--- a/project/Защита_проекта_Микросервис_на_основе_Apache_Kafka.pptx
+++ b/project/Защита_проекта_Микросервис_на_основе_Apache_Kafka.pptx
@@ -24,16 +24,15 @@
     <p:sldId id="264" r:id="rId20"/>
     <p:sldId id="265" r:id="rId21"/>
     <p:sldId id="266" r:id="rId22"/>
-    <p:sldId id="274" r:id="rId23"/>
   </p:sldIdLst>
   <p:sldSz cx="9144000" cy="6858000"/>
   <p:notesSz cx="6858000" cy="9144000"/>
   <p:embeddedFontLst>
     <p:embeddedFont>
       <p:font typeface="Roboto" pitchFamily="0" charset="0"/>
-      <p:regular r:id="rId24"/>
-      <p:bold r:id="rId25"/>
-      <p:italic r:id="rId26"/>
+      <p:regular r:id="rId23"/>
+      <p:bold r:id="rId24"/>
+      <p:italic r:id="rId25"/>
     </p:embeddedFont>
   </p:embeddedFontLst>
   <p:defaultTextStyle>
@@ -271,7 +270,7 @@
             <a:spLocks noGrp="1" noChangeArrowheads="1"/>
             <a:extLst>
               <a:ext uri="smNativeData">
-                <pr:smNativeData xmlns:pr="smNativeData" xmlns="smNativeData" val="SMDATA_15_EkJ5ZhMAAAAlAAAACwAAAA0AAAAACAcAADgEAAAoIwAAUBkAAAAAAAAAAAAAAAAAAAEAAABQAAAAAAAAAAAA4D8AAAAAAADgPwAAAAAAAOA/AAAAAAAA4D8AAAAAAADgPwAAAAAAAOA/AAAAAAAA4D8AAAAAAADgPwAAAAAAAOA/AAAAAAAA4D8CAAAAjAAAAAAAAAAAAAAABY3HDP///wgAAAAAAAAAAAAAAAAAAAAAAAAAAAAAAAAAAAAAZAAAAAEAAABAAAAAAAAAAAAAAAAAAAAAAAAAAAAAAAAAAAAAAAAAAAAAAAAAAAAAAAAAAAAAAAAAAAAAAAAAAAAAAAAAAAAAAAAAAAAAAAAAAAAAAAAAAAAAAAAAAAAAFAAAADwAAAABAAAAAAAAAAAAAAAPAAAAAQAAACMAAAAjAAAAIwAAAB4AAAAAAAAASwAAAEsAAAAAAAAASwAAAEsAAAAVAAAAYAAAAAAAAAAAAAAADwAAACADAAAAAAAAAAAAAAEAAACgMgAAVgcAAKr4//8BAAAAf39/AAEAAABkAAAAAAAAABQAAABAHwAAAAAAACYAAAAAAAAAwOD//wAAAAAmAAAAZAAAABYAAABMAAAAAAAAAAAAAAAEAAAAAAAAAAEAAAAVgVgKAAAAACgAAAAoAAAAZAAAAGQAAAAAAAAAzMzMAAAAAABQAAAAUAAAAGQAAABkAAAAAAAAABcAAAAUAAAAAAAAAAAAAAD/fwAA/38AAAAAAAAJAAAABAAAACwAAAAeAAAAaAAAAAAAAAAAAAAAAAAAAAAAAAAAAAAAECcAABAnAAAAAAAAAAAAAAAAAAAAAAAAAAAAAAAAAAAAAAAAAAAAABQAAAAAAAAAwMD/AAAAAABkAAAAMgAAAAAAAABkAAAAAAAAAH9/fwAKAAAAIgAAABgAAAAAAAAAAAAAAAAAAAAAAAAAAAAAAAAAAAAkAAAAJAAAAAAAAAAHAAAAAAAAAAAAAAAAAAAAAAAAAAAAAAAAAAAAf39/ACUAAABYAAAAAAAAAAAAAAAAAAAAAAAAAAAAAAAAAAAAAAAAAAAAAAAAAAAAAAAAAAAAAAA/AAAAAAAAAKCGAQAAAAAAAAAAAAAAAAAMAAAAAQAAAAAAAAAAAAAAAAAAAB8AAABUAAAAAAAABQAAAAEAAAAAAAAAAAAAAAAAAAAAAAAAAAAAAAAAAAAAAAAAAAAAAAB/f38AAAAAA8zMzADAwP8Af39/AAAAAAAAAAAAAAAAAAAAAAAAAAAAIQAAABgAAAAUAAAACAcAADgEAAAoIwAAUBkAABAAAAAmAAAACAAAAAEPAAD/HwAA"/>
+                <pr:smNativeData xmlns:pr="smNativeData" xmlns="smNativeData" val="SMDATA_15_LkR5ZhMAAAAlAAAACwAAAA0AAAAACAcAADgEAAAoIwAAUBkAAAAAAAAAAAAAAAAAAAEAAABQAAAAAAAAAAAA4D8AAAAAAADgPwAAAAAAAOA/AAAAAAAA4D8AAAAAAADgPwAAAAAAAOA/AAAAAAAA4D8AAAAAAADgPwAAAAAAAOA/AAAAAAAA4D8CAAAAjAAAAAAAAAAAAAAABY3HDP///wgAAAAAAAAAAAAAAAAAAAAAAAAAAAAAAAAAAAAAZAAAAAEAAABAAAAAAAAAAAAAAAAAAAAAAAAAAAAAAAAAAAAAAAAAAAAAAAAAAAAAAAAAAAAAAAAAAAAAAAAAAAAAAAAAAAAAAAAAAAAAAAAAAAAAAAAAAAAAAAAAAAAAFAAAADwAAAABAAAAAAAAAAAAAAAPAAAAAQAAACMAAAAjAAAAIwAAAB4AAAAAAAAASwAAAEsAAAAAAAAASwAAAEsAAAAVAAAAYAAAAAAAAAAAAAAADwAAACADAAAAAAAAAAAAAAEAAACgMgAAVgcAAKr4//8BAAAAf39/AAEAAABkAAAAAAAAABQAAABAHwAAAAAAACYAAAAAAAAAwOD//wAAAAAmAAAAZAAAABYAAABMAAAAAAAAAAAAAAAEAAAAAAAAAAEAAAAVgVgKAAAAACgAAAAoAAAAZAAAAGQAAAAAAAAAzMzMAAAAAABQAAAAUAAAAGQAAABkAAAAAAAAABcAAAAUAAAAAAAAAAAAAAD/fwAA/38AAAAAAAAJAAAABAAAACwAAAAeAAAAaAAAAAAAAAAAAAAAAAAAAAAAAAAAAAAAECcAABAnAAAAAAAAAAAAAAAAAAAAAAAAAAAAAAAAAAAAAAAAAAAAABQAAAAAAAAAwMD/AAAAAABkAAAAMgAAAAAAAABkAAAAAAAAAH9/fwAKAAAAIgAAABgAAAAAAAAAAAAAAAAAAAAAAAAAAAAAAAAAAAAkAAAAJAAAAAAAAAAHAAAAAAAAAAAAAAAAAAAAAAAAAAAAAAAAAAAAf39/ACUAAABYAAAAAAAAAAAAAAAAAAAAAAAAAAAAAAAAAAAAAAAAAAAAAAAAAAAAAAAAAAAAAAA/AAAAAAAAAKCGAQAAAAAAAAAAAAAAAAAMAAAAAQAAAAAAAAAAAAAAAAAAAB8AAABUAAAAAAAABQAAAAEAAAAAAAAAAAAAAAAAAAAAAAAAAAAAAAAAAAAAAAAAAAAAAAB/f38AAAAAA8zMzADAwP8Af39/AAAAAAAAAAAAAAAAAAAAAAAAAAAAIQAAABgAAAAUAAAACAcAADgEAAAoIwAAUBkAABAAAAAmAAAACAAAAAEPAAD/HwAA"/>
               </a:ext>
             </a:extLst>
           </p:cNvSpPr>
@@ -326,7 +325,7 @@
             <a:spLocks noGrp="1" noChangeArrowheads="1"/>
             <a:extLst>
               <a:ext uri="smNativeData">
-                <pr:smNativeData xmlns:pr="smNativeData" xmlns="smNativeData" val="SMDATA_15_EkJ5ZhMAAAAlAAAAZAAAAA0AAAAAkAAAAJAAAACQAAAAkAAAAAAAAAAAAAAAAAAAAAEAAABQAAAAAAAAAAAA4D8AAAAAAADgPwAAAAAAAOA/AAAAAAAA4D8AAAAAAADgPwAAAAAAAOA/AAAAAAAA4D8AAAAAAADgPwAAAAAAAOA/AAAAAAAA4D8CAAAAjAAAAAAAAAAAAAAABY3HDP///wgAAAAAAAAAAAAAAAAAAAAAAAAAAAAAAAAAAAAAZAAAAAEAAABAAAAAAAAAAAAAAAAAAAAAAAAAAAAAAAAAAAAAAAAAAAAAAAAAAAAAAAAAAAAAAAAAAAAAAAAAAAAAAAAAAAAAAAAAAAAAAAAAAAAAAAAAAAAAAAAAAAAAFAAAADwAAAAAAAAAAAAAAAAAAAkUAAAAAQAAABQAAAAUAAAAFAAAAAEAAAAAAAAAZAAAAGQAAAAAAAAAZAAAAGQAAAAVAAAAYAAAAAAAAAAAAAAADwAAACADAAAAAAAAAAAAAAEAAACgMgAAVgcAAKr4//8BAAAAf39/AAEAAABkAAAAAAAAABQAAABAHwAAAAAAACYAAAAAAAAAwOD//wAAAAAmAAAAZAAAABYAAABMAAAAAAAAAAAAAAAEAAAAAAAAAAEAAAAVgVgKAAAAACgAAAAoAAAAZAAAAGQAAAAAAAAAzMzMAAAAAABQAAAAUAAAAGQAAABkAAAAAAAAABcAAAAUAAAAAAAAAAAAAAD/fwAA/38AAAAAAAAJAAAABAAAAHsAfAAeAAAAaAAAAAAAAAAAAAAAAAAAAAAAAAAAAAAAECcAABAnAAAAAAAAAAAAAAAAAAAAAAAAAAAAAAAAAAAAAAAAAAAAABQAAAAAAAAAwMD/AAAAAABkAAAAMgAAAAAAAABkAAAAAAAAAH9/fwAKAAAAIgAAABgAAAAAAAAAAAAAAAAAAAAAAAAAAAAAAAAAAAAkAAAAJAAAAAAAAAAHAAAAAAAAAAAAAAAAAAAAAAAAAAAAAAAAAAAAf39/ACUAAABYAAAAAAAAAAAAAAAAAAAAAAAAAAAAAAAAAAAAAAAAAAAAAAAAAAAAAAAAAAAAAAA/AAAAAAAAAKCGAQAAAAAAAAAAAAAAAAAMAAAAAQAAAAAAAAAAAAAAAAAAAB8AAABUAAAAAAAABQAAAAEAAAAAAAAAAAAAAAAAAAAAAAAAAAAAAAAAAAAAAAAAAAAAAAJ/f38AAAAAA8zMzADAwP8Af39/AAAAAAAAAAAAAAAAAAAAAAAAAAAAIQAAABgAAAAUAAAAOAQAALgaAAD4JQAACDQAABAAAAAmAAAACAAAAL2/AAD/HwAA"/>
+                <pr:smNativeData xmlns:pr="smNativeData" xmlns="smNativeData" val="SMDATA_15_LkR5ZhMAAAAlAAAAZAAAAA0AAAAAkAAAAJAAAACQAAAAkAAAAAAAAAAAAAAAAAAAAAEAAABQAAAAAAAAAAAA4D8AAAAAAADgPwAAAAAAAOA/AAAAAAAA4D8AAAAAAADgPwAAAAAAAOA/AAAAAAAA4D8AAAAAAADgPwAAAAAAAOA/AAAAAAAA4D8CAAAAjAAAAAAAAAAAAAAABY3HDP///wgAAAAAAAAAAAAAAAAAAAAAAAAAAAAAAAAAAAAAZAAAAAEAAABAAAAAAAAAAAAAAAAAAAAAAAAAAAAAAAAAAAAAAAAAAAAAAAAAAAAAAAAAAAAAAAAAAAAAAAAAAAAAAAAAAAAAAAAAAAAAAAAAAAAAAAAAAAAAAAAAAAAAFAAAADwAAAAAAAAAAAAAAAAAAAkUAAAAAQAAABQAAAAUAAAAFAAAAAEAAAAAAAAAZAAAAGQAAAAAAAAAZAAAAGQAAAAVAAAAYAAAAAAAAAAAAAAADwAAACADAAAAAAAAAAAAAAEAAACgMgAAVgcAAKr4//8BAAAAf39/AAEAAABkAAAAAAAAABQAAABAHwAAAAAAACYAAAAAAAAAwOD//wAAAAAmAAAAZAAAABYAAABMAAAAAAAAAAAAAAAEAAAAAAAAAAEAAAAVgVgKAAAAACgAAAAoAAAAZAAAAGQAAAAAAAAAzMzMAAAAAABQAAAAUAAAAGQAAABkAAAAAAAAABcAAAAUAAAAAAAAAAAAAAD/fwAA/38AAAAAAAAJAAAABAAAAHsAfAAeAAAAaAAAAAAAAAAAAAAAAAAAAAAAAAAAAAAAECcAABAnAAAAAAAAAAAAAAAAAAAAAAAAAAAAAAAAAAAAAAAAAAAAABQAAAAAAAAAwMD/AAAAAABkAAAAMgAAAAAAAABkAAAAAAAAAH9/fwAKAAAAIgAAABgAAAAAAAAAAAAAAAAAAAAAAAAAAAAAAAAAAAAkAAAAJAAAAAAAAAAHAAAAAAAAAAAAAAAAAAAAAAAAAAAAAAAAAAAAf39/ACUAAABYAAAAAAAAAAAAAAAAAAAAAAAAAAAAAAAAAAAAAAAAAAAAAAAAAAAAAAAAAAAAAAA/AAAAAAAAAKCGAQAAAAAAAAAAAAAAAAAMAAAAAQAAAAAAAAAAAAAAAAAAAB8AAABUAAAAAAAABQAAAAEAAAAAAAAAAAAAAAAAAAAAAAAAAAAAAAAAAAAAAAAAAAAAAAJ/f38AAAAAA8zMzADAwP8Af39/AAAAAAAAAAAAAAAAAAAAAAAAAAAAIQAAABgAAAAUAAAAOAQAALgaAAD4JQAACDQAABAAAAAmAAAACAAAAL2/AAD/HwAA"/>
               </a:ext>
             </a:extLst>
           </p:cNvSpPr>
@@ -698,7 +697,7 @@
             <a:spLocks noGrp="1" noChangeArrowheads="1"/>
             <a:extLst>
               <a:ext uri="smNativeData">
-                <pr:smNativeData xmlns:pr="smNativeData" xmlns="smNativeData" val="SMDATA_15_EkJ5ZhMAAAAlAAAACwAAAA0AAAAACAcAADgEAAAoIwAAUBkAAAAAAAAAAAAAAAAAAAEAAABQAAAAAAAAAAAA4D8AAAAAAADgPwAAAAAAAOA/AAAAAAAA4D8AAAAAAADgPwAAAAAAAOA/AAAAAAAA4D8AAAAAAADgPwAAAAAAAOA/AAAAAAAA4D8CAAAAjAAAAAAAAAAAAAAAQoX0DP///wgAAAAAAAAAAAAAAAAAAAAAAAAAAAAAAAAAAAAAZAAAAAEAAABAAAAAAAAAAAAAAAAAAAAAAAAAAAAAAAAAAAAAAAAAAAAAAAAAAAAAAAAAAAAAAAAAAAAAAAAAAAAAAAAAAAAAAAAAAAAAAAAAAAAAAAAAAAAAAAAAAAAAFAAAADwAAAABAAAAAAAAAAAAAAAPAAAAAQAAACMAAAAjAAAAIwAAAB4AAAAAAAAASwAAAEsAAAAAAAAASwAAAEsAAAAVAAAAYAAAAAAAAAAAAAAADwAAACADAAAAAAAAAAAAAAEAAACgMgAAVgcAAKr4//8BAAAAf39/AAEAAABkAAAAAAAAABQAAABAHwAAAAAAACYAAAAAAAAAwOD//wAAAAAmAAAAZAAAABYAAABMAAAAAAAAAAAAAAAEAAAAAAAAAAEAAABZWVkKAAAAACgAAAAoAAAAZAAAAGQAAAAAAAAAzMzMAAAAAABQAAAAUAAAAGQAAABkAAAAAAAAABcAAAAUAAAAAAAAAAAAAAD/fwAA/38AAAAAAAAJAAAABAAAAAAAAAAeAAAAaAAAAAAAAAAAAAAAAAAAAAAAAAAAAAAAECcAABAnAAAAAAAAAAAAAAAAAAAAAAAAAAAAAAAAAAAAAAAAAAAAABQAAAAAAAAAwMD/AAAAAABkAAAAMgAAAAAAAABkAAAAAAAAAH9/fwAKAAAAIgAAABgAAAAAAAAAAAAAAAAAAAAAAAAAAAAAAAAAAAAkAAAAJAAAAAAAAAAHAAAAAAAAAAAAAAAAAAAAAAAAAAAAAAAAAAAAf39/ACUAAABYAAAAAAAAAAAAAAAAAAAAAAAAAAAAAAAAAAAAAAAAAAAAAAAAAAAAAAAAAAAAAAA/AAAAAAAAAKCGAQAAAAAAAAAAAAAAAAAMAAAAAQAAAAAAAAAAAAAAAAAAAB8AAABUAAAAAAAABQAAAAEAAAAAAAAAAAAAAAAAAAAAAAAAAAAAAAAAAAAAAAAAAAAAAAB/f38AAAAAA8zMzADAwP8Af39/AAAAAAAAAAAAAAAAAAAAAAAAAAAAIQAAABgAAAAUAAAACAcAADgEAAAoIwAAUBkAABAAAAAmAAAACAAAAAEPAAAAAAAA"/>
+                <pr:smNativeData xmlns:pr="smNativeData" xmlns="smNativeData" val="SMDATA_15_LkR5ZhMAAAAlAAAACwAAAA0AAAAACAcAADgEAAAoIwAAUBkAAAAAAAAAAAAAAAAAAAEAAABQAAAAAAAAAAAA4D8AAAAAAADgPwAAAAAAAOA/AAAAAAAA4D8AAAAAAADgPwAAAAAAAOA/AAAAAAAA4D8AAAAAAADgPwAAAAAAAOA/AAAAAAAA4D8CAAAAjAAAAAAAAAAAAAAAQoX0DP///wgAAAAAAAAAAAAAAAAAAAAAAAAAAAAAAAAAAAAAZAAAAAEAAABAAAAAAAAAAAAAAAAAAAAAAAAAAAAAAAAAAAAAAAAAAAAAAAAAAAAAAAAAAAAAAAAAAAAAAAAAAAAAAAAAAAAAAAAAAAAAAAAAAAAAAAAAAAAAAAAAAAAAFAAAADwAAAABAAAAAAAAAAAAAAAPAAAAAQAAACMAAAAjAAAAIwAAAB4AAAAAAAAASwAAAEsAAAAAAAAASwAAAEsAAAAVAAAAYAAAAAAAAAAAAAAADwAAACADAAAAAAAAAAAAAAEAAACgMgAAVgcAAKr4//8BAAAAf39/AAEAAABkAAAAAAAAABQAAABAHwAAAAAAACYAAAAAAAAAwOD//wAAAAAmAAAAZAAAABYAAABMAAAAAAAAAAAAAAAEAAAAAAAAAAEAAABZWVkKAAAAACgAAAAoAAAAZAAAAGQAAAAAAAAAzMzMAAAAAABQAAAAUAAAAGQAAABkAAAAAAAAABcAAAAUAAAAAAAAAAAAAAD/fwAA/38AAAAAAAAJAAAABAAAAAAAAAAeAAAAaAAAAAAAAAAAAAAAAAAAAAAAAAAAAAAAECcAABAnAAAAAAAAAAAAAAAAAAAAAAAAAAAAAAAAAAAAAAAAAAAAABQAAAAAAAAAwMD/AAAAAABkAAAAMgAAAAAAAABkAAAAAAAAAH9/fwAKAAAAIgAAABgAAAAAAAAAAAAAAAAAAAAAAAAAAAAAAAAAAAAkAAAAJAAAAAAAAAAHAAAAAAAAAAAAAAAAAAAAAAAAAAAAAAAAAAAAf39/ACUAAABYAAAAAAAAAAAAAAAAAAAAAAAAAAAAAAAAAAAAAAAAAAAAAAAAAAAAAAAAAAAAAAA/AAAAAAAAAKCGAQAAAAAAAAAAAAAAAAAMAAAAAQAAAAAAAAAAAAAAAAAAAB8AAABUAAAAAAAABQAAAAEAAAAAAAAAAAAAAAAAAAAAAAAAAAAAAAAAAAAAAAAAAAAAAAB/f38AAAAAA8zMzADAwP8Af39/AAAAAAAAAAAAAAAAAAAAAAAAAAAAIQAAABgAAAAUAAAACAcAADgEAAAoIwAAUBkAABAAAAAmAAAACAAAAAEPAAAAAAAA"/>
               </a:ext>
             </a:extLst>
           </p:cNvSpPr>
@@ -744,7 +743,7 @@
             <a:spLocks noGrp="1" noChangeArrowheads="1"/>
             <a:extLst>
               <a:ext uri="smNativeData">
-                <pr:smNativeData xmlns:pr="smNativeData" xmlns="smNativeData" val="SMDATA_15_EkJ5ZhMAAAAlAAAAZAAAAA0AAAAAkAAAAJAAAACQAAAAkAAAAAAAAAAAAAAAAAAAAAEAAABQAAAAAAAAAAAA4D8AAAAAAADgPwAAAAAAAOA/AAAAAAAA4D8AAAAAAADgPwAAAAAAAOA/AAAAAAAA4D8AAAAAAADgPwAAAAAAAOA/AAAAAAAA4D8CAAAAjAAAAAAAAAAAAAAAQoX0DP///wgAAAAAAAAAAAAAAAAAAAAAAAAAAAAAAAAAAAAAZAAAAAEAAABAAAAAAAAAAAAAAAAAAAAAAAAAAAAAAAAAAAAAAAAAAAAAAAAAAAAAAAAAAAAAAAAAAAAAAAAAAAAAAAAAAAAAAAAAAAAAAAAAAAAAAAAAAAAAAAAAAAAAFAAAADwAAAAAAAAAAAAAAAAAAAkUAAAAAQAAABQAAAAUAAAAFAAAAAEAAAAAAAAAZAAAAGQAAAAAAAAAZAAAAGQAAAAVAAAAYAAAAAAAAAAAAAAADwAAACADAAAAAAAAAAAAAAEAAACgMgAAVgcAAKr4//8BAAAAf39/AAEAAABkAAAAAAAAABQAAABAHwAAAAAAACYAAAAAAAAAwOD//wAAAAAmAAAAZAAAABYAAABMAAAAAAAAAAAAAAAEAAAAAAAAAAEAAABZWVkKAAAAACgAAAAoAAAAZAAAAGQAAAAAAAAAzMzMAAAAAABQAAAAUAAAAGQAAABkAAAAAAAAABcAAAAUAAAAAAAAAAAAAAD/fwAA/38AAAAAAAAJAAAABAAAAAAAAAAeAAAAaAAAAAAAAAAAAAAAAAAAAAAAAAAAAAAAECcAABAnAAAAAAAAAAAAAAAAAAAAAAAAAAAAAAAAAAAAAAAAAAAAABQAAAAAAAAAwMD/AAAAAABkAAAAMgAAAAAAAABkAAAAAAAAAH9/fwAKAAAAIgAAABgAAAAAAAAAAAAAAAAAAAAAAAAAAAAAAAAAAAAkAAAAJAAAAAAAAAAHAAAAAAAAAAAAAAAAAAAAAAAAAAAAAAAAAAAAf39/ACUAAABYAAAAAAAAAAAAAAAAAAAAAAAAAAAAAAAAAAAAAAAAAAAAAAAAAAAAAAAAAAAAAAA/AAAAAAAAAKCGAQAAAAAAAAAAAAAAAAAMAAAAAQAAAAAAAAAAAAAAAAAAAB8AAABUAAAAAAAABQAAAAEAAAAAAAAAAAAAAAAAAAAAAAAAAAAAAAAAAAAAAAAAAAAAAAJ/f38AAAAAA8zMzADAwP8Af39/AAAAAAAAAAAAAAAAAAAAAAAAAAAAIQAAABgAAAAUAAAAOAQAALgaAAD4JQAACDQAABAAAAAmAAAACAAAAL0/AAAAAAAA"/>
+                <pr:smNativeData xmlns:pr="smNativeData" xmlns="smNativeData" val="SMDATA_15_LkR5ZhMAAAAlAAAAZAAAAA0AAAAAkAAAAJAAAACQAAAAkAAAAAAAAAAAAAAAAAAAAAEAAABQAAAAAAAAAAAA4D8AAAAAAADgPwAAAAAAAOA/AAAAAAAA4D8AAAAAAADgPwAAAAAAAOA/AAAAAAAA4D8AAAAAAADgPwAAAAAAAOA/AAAAAAAA4D8CAAAAjAAAAAAAAAAAAAAAQoX0DP///wgAAAAAAAAAAAAAAAAAAAAAAAAAAAAAAAAAAAAAZAAAAAEAAABAAAAAAAAAAAAAAAAAAAAAAAAAAAAAAAAAAAAAAAAAAAAAAAAAAAAAAAAAAAAAAAAAAAAAAAAAAAAAAAAAAAAAAAAAAAAAAAAAAAAAAAAAAAAAAAAAAAAAFAAAADwAAAAAAAAAAAAAAAAAAAkUAAAAAQAAABQAAAAUAAAAFAAAAAEAAAAAAAAAZAAAAGQAAAAAAAAAZAAAAGQAAAAVAAAAYAAAAAAAAAAAAAAADwAAACADAAAAAAAAAAAAAAEAAACgMgAAVgcAAKr4//8BAAAAf39/AAEAAABkAAAAAAAAABQAAABAHwAAAAAAACYAAAAAAAAAwOD//wAAAAAmAAAAZAAAABYAAABMAAAAAAAAAAAAAAAEAAAAAAAAAAEAAABZWVkKAAAAACgAAAAoAAAAZAAAAGQAAAAAAAAAzMzMAAAAAABQAAAAUAAAAGQAAABkAAAAAAAAABcAAAAUAAAAAAAAAAAAAAD/fwAA/38AAAAAAAAJAAAABAAAAAAAAAAeAAAAaAAAAAAAAAAAAAAAAAAAAAAAAAAAAAAAECcAABAnAAAAAAAAAAAAAAAAAAAAAAAAAAAAAAAAAAAAAAAAAAAAABQAAAAAAAAAwMD/AAAAAABkAAAAMgAAAAAAAABkAAAAAAAAAH9/fwAKAAAAIgAAABgAAAAAAAAAAAAAAAAAAAAAAAAAAAAAAAAAAAAkAAAAJAAAAAAAAAAHAAAAAAAAAAAAAAAAAAAAAAAAAAAAAAAAAAAAf39/ACUAAABYAAAAAAAAAAAAAAAAAAAAAAAAAAAAAAAAAAAAAAAAAAAAAAAAAAAAAAAAAAAAAAA/AAAAAAAAAKCGAQAAAAAAAAAAAAAAAAAMAAAAAQAAAAAAAAAAAAAAAAAAAB8AAABUAAAAAAAABQAAAAEAAAAAAAAAAAAAAAAAAAAAAAAAAAAAAAAAAAAAAAAAAAAAAAJ/f38AAAAAA8zMzADAwP8Af39/AAAAAAAAAAAAAAAAAAAAAAAAAAAAIQAAABgAAAAUAAAAOAQAALgaAAD4JQAACDQAABAAAAAmAAAACAAAAL0/AAAAAAAA"/>
               </a:ext>
             </a:extLst>
           </p:cNvSpPr>
@@ -821,7 +820,7 @@
             <a:spLocks noGrp="1" noChangeArrowheads="1"/>
             <a:extLst>
               <a:ext uri="smNativeData">
-                <pr:smNativeData xmlns:pr="smNativeData" xmlns="smNativeData" val="SMDATA_15_EkJ5ZhMAAAAlAAAACwAAAA0AAAAACAcAADgEAAAoIwAAUBkAAAAAAAAAAAAAAAAAAAEAAABQAAAAAAAAAAAA4D8AAAAAAADgPwAAAAAAAOA/AAAAAAAA4D8AAAAAAADgPwAAAAAAAOA/AAAAAAAA4D8AAAAAAADgPwAAAAAAAOA/AAAAAAAA4D8CAAAAjAAAAAAAAAAAAAAAQoX0DP///wgAAAAAAAAAAAAAAAAAAAAAAAAAAAAAAAAAAAAAZAAAAAEAAABAAAAAAAAAAAAAAAAAAAAAAAAAAAAAAAAAAAAAAAAAAAAAAAAAAAAAAAAAAAAAAAAAAAAAAAAAAAAAAAAAAAAAAAAAAAAAAAAAAAAAAAAAAAAAAAAAAAAAFAAAADwAAAABAAAAAAAAAAAAAAAPAAAAAQAAACMAAAAjAAAAIwAAAB4AAAAAAAAASwAAAEsAAAAAAAAASwAAAEsAAAAVAAAAYAAAAAAAAAAAAAAADwAAACADAAAAAAAAAAAAAAEAAACgMgAAVgcAAKr4//8BAAAAf39/AAEAAABkAAAAAAAAABQAAABAHwAAAAAAACYAAAAAAAAAwOD//wAAAAAmAAAAZAAAABYAAABMAAAAAAAAAAAAAAAEAAAAAAAAAAEAAABZWVkKAAAAACgAAAAoAAAAZAAAAGQAAAAAAAAAzMzMAAAAAABQAAAAUAAAAGQAAABkAAAAAAAAABcAAAAUAAAAAAAAAAAAAAD/fwAA/38AAAAAAAAJAAAABAAAALQAAAAeAAAAaAAAAAAAAAAAAAAAAAAAAAAAAAAAAAAAECcAABAnAAAAAAAAAAAAAAAAAAAAAAAAAAAAAAAAAAAAAAAAAAAAABQAAAAAAAAAwMD/AAAAAABkAAAAMgAAAAAAAABkAAAAAAAAAH9/fwAKAAAAIgAAABgAAAAAAAAAAAAAAAAAAAAAAAAAAAAAAAAAAAAkAAAAJAAAAAAAAAAHAAAAAAAAAAAAAAAAAAAAAAAAAAAAAAAAAAAAf39/ACUAAABYAAAAAAAAAAAAAAAAAAAAAAAAAAAAAAAAAAAAAAAAAAAAAAAAAAAAAAAAAAAAAAA/AAAAAAAAAKCGAQAAAAAAAAAAAAAAAAAMAAAAAQAAAAAAAAAAAAAAAAAAAB8AAABUAAAAAAAABQAAAAEAAAAAAAAAAAAAAAAAAAAAAAAAAAAAAAAAAAAAAAAAAAAAAAB/f38AAAAAA8zMzADAwP8Af39/AAAAAAAAAAAAAAAAAAAAAAAAAAAAIQAAABgAAAAUAAAACAcAADgEAAAoIwAAUBkAABAAAAAmAAAACAAAAAEPAAAAAAAA"/>
+                <pr:smNativeData xmlns:pr="smNativeData" xmlns="smNativeData" val="SMDATA_15_LkR5ZhMAAAAlAAAACwAAAA0AAAAACAcAADgEAAAoIwAAUBkAAAAAAAAAAAAAAAAAAAEAAABQAAAAAAAAAAAA4D8AAAAAAADgPwAAAAAAAOA/AAAAAAAA4D8AAAAAAADgPwAAAAAAAOA/AAAAAAAA4D8AAAAAAADgPwAAAAAAAOA/AAAAAAAA4D8CAAAAjAAAAAAAAAAAAAAAQoX0DP///wgAAAAAAAAAAAAAAAAAAAAAAAAAAAAAAAAAAAAAZAAAAAEAAABAAAAAAAAAAAAAAAAAAAAAAAAAAAAAAAAAAAAAAAAAAAAAAAAAAAAAAAAAAAAAAAAAAAAAAAAAAAAAAAAAAAAAAAAAAAAAAAAAAAAAAAAAAAAAAAAAAAAAFAAAADwAAAABAAAAAAAAAAAAAAAPAAAAAQAAACMAAAAjAAAAIwAAAB4AAAAAAAAASwAAAEsAAAAAAAAASwAAAEsAAAAVAAAAYAAAAAAAAAAAAAAADwAAACADAAAAAAAAAAAAAAEAAACgMgAAVgcAAKr4//8BAAAAf39/AAEAAABkAAAAAAAAABQAAABAHwAAAAAAACYAAAAAAAAAwOD//wAAAAAmAAAAZAAAABYAAABMAAAAAAAAAAAAAAAEAAAAAAAAAAEAAABZWVkKAAAAACgAAAAoAAAAZAAAAGQAAAAAAAAAzMzMAAAAAABQAAAAUAAAAGQAAABkAAAAAAAAABcAAAAUAAAAAAAAAAAAAAD/fwAA/38AAAAAAAAJAAAABAAAALQAAAAeAAAAaAAAAAAAAAAAAAAAAAAAAAAAAAAAAAAAECcAABAnAAAAAAAAAAAAAAAAAAAAAAAAAAAAAAAAAAAAAAAAAAAAABQAAAAAAAAAwMD/AAAAAABkAAAAMgAAAAAAAABkAAAAAAAAAH9/fwAKAAAAIgAAABgAAAAAAAAAAAAAAAAAAAAAAAAAAAAAAAAAAAAkAAAAJAAAAAAAAAAHAAAAAAAAAAAAAAAAAAAAAAAAAAAAAAAAAAAAf39/ACUAAABYAAAAAAAAAAAAAAAAAAAAAAAAAAAAAAAAAAAAAAAAAAAAAAAAAAAAAAAAAAAAAAA/AAAAAAAAAKCGAQAAAAAAAAAAAAAAAAAMAAAAAQAAAAAAAAAAAAAAAAAAAB8AAABUAAAAAAAABQAAAAEAAAAAAAAAAAAAAAAAAAAAAAAAAAAAAAAAAAAAAAAAAAAAAAB/f38AAAAAA8zMzADAwP8Af39/AAAAAAAAAAAAAAAAAAAAAAAAAAAAIQAAABgAAAAUAAAACAcAADgEAAAoIwAAUBkAABAAAAAmAAAACAAAAAEPAAAAAAAA"/>
               </a:ext>
             </a:extLst>
           </p:cNvSpPr>
@@ -867,7 +866,7 @@
             <a:spLocks noGrp="1" noChangeArrowheads="1"/>
             <a:extLst>
               <a:ext uri="smNativeData">
-                <pr:smNativeData xmlns:pr="smNativeData" xmlns="smNativeData" val="SMDATA_15_EkJ5ZhMAAAAlAAAAZAAAAA0AAAAAkAAAAJAAAACQAAAAkAAAAAAAAAAAAAAAAAAAAAEAAABQAAAAAAAAAAAA4D8AAAAAAADgPwAAAAAAAOA/AAAAAAAA4D8AAAAAAADgPwAAAAAAAOA/AAAAAAAA4D8AAAAAAADgPwAAAAAAAOA/AAAAAAAA4D8CAAAAjAAAAAAAAAAAAAAAQoX0DP///wgAAAAAAAAAAAAAAAAAAAAAAAAAAAAAAAAAAAAAZAAAAAEAAABAAAAAAAAAAAAAAAAAAAAAAAAAAAAAAAAAAAAAAAAAAAAAAAAAAAAAAAAAAAAAAAAAAAAAAAAAAAAAAAAAAAAAAAAAAAAAAAAAAAAAAAAAAAAAAAAAAAAAFAAAADwAAAAAAAAAAAAAAAAAAAkUAAAAAQAAABQAAAAUAAAAFAAAAAEAAAAAAAAAZAAAAGQAAAAAAAAAZAAAAGQAAAAVAAAAYAAAAAAAAAAAAAAADwAAACADAAAAAAAAAAAAAAEAAACgMgAAVgcAAKr4//8BAAAAf39/AAEAAABkAAAAAAAAABQAAABAHwAAAAAAACYAAAAAAAAAwOD//wAAAAAmAAAAZAAAABYAAABMAAAAAAAAAAAAAAAEAAAAAAAAAAEAAABZWVkKAAAAACgAAAAoAAAAZAAAAGQAAAAAAAAAzMzMAAAAAABQAAAAUAAAAGQAAABkAAAAAAAAABcAAAAUAAAAAAAAAAAAAAD/fwAA/38AAAAAAAAJAAAABAAAAIK8UsUeAAAAaAAAAAAAAAAAAAAAAAAAAAAAAAAAAAAAECcAABAnAAAAAAAAAAAAAAAAAAAAAAAAAAAAAAAAAAAAAAAAAAAAABQAAAAAAAAAwMD/AAAAAABkAAAAMgAAAAAAAABkAAAAAAAAAH9/fwAKAAAAIgAAABgAAAAAAAAAAAAAAAAAAAAAAAAAAAAAAAAAAAAkAAAAJAAAAAAAAAAHAAAAAAAAAAAAAAAAAAAAAAAAAAAAAAAAAAAAf39/ACUAAABYAAAAAAAAAAAAAAAAAAAAAAAAAAAAAAAAAAAAAAAAAAAAAAAAAAAAAAAAAAAAAAA/AAAAAAAAAKCGAQAAAAAAAAAAAAAAAAAMAAAAAQAAAAAAAAAAAAAAAAAAAB8AAABUAAAAAAAABQAAAAEAAAAAAAAAAAAAAAAAAAAAAAAAAAAAAAAAAAAAAAAAAAAAAAJ/f38AAAAAA8zMzADAwP8Af39/AAAAAAAAAAAAAAAAAAAAAAAAAAAAIQAAABgAAAAUAAAAOAQAALgaAAD4JQAACDQAABAAAAAmAAAACAAAAL0/AAAAAAAA"/>
+                <pr:smNativeData xmlns:pr="smNativeData" xmlns="smNativeData" val="SMDATA_15_LkR5ZhMAAAAlAAAAZAAAAA0AAAAAkAAAAJAAAACQAAAAkAAAAAAAAAAAAAAAAAAAAAEAAABQAAAAAAAAAAAA4D8AAAAAAADgPwAAAAAAAOA/AAAAAAAA4D8AAAAAAADgPwAAAAAAAOA/AAAAAAAA4D8AAAAAAADgPwAAAAAAAOA/AAAAAAAA4D8CAAAAjAAAAAAAAAAAAAAAQoX0DP///wgAAAAAAAAAAAAAAAAAAAAAAAAAAAAAAAAAAAAAZAAAAAEAAABAAAAAAAAAAAAAAAAAAAAAAAAAAAAAAAAAAAAAAAAAAAAAAAAAAAAAAAAAAAAAAAAAAAAAAAAAAAAAAAAAAAAAAAAAAAAAAAAAAAAAAAAAAAAAAAAAAAAAFAAAADwAAAAAAAAAAAAAAAAAAAkUAAAAAQAAABQAAAAUAAAAFAAAAAEAAAAAAAAAZAAAAGQAAAAAAAAAZAAAAGQAAAAVAAAAYAAAAAAAAAAAAAAADwAAACADAAAAAAAAAAAAAAEAAACgMgAAVgcAAKr4//8BAAAAf39/AAEAAABkAAAAAAAAABQAAABAHwAAAAAAACYAAAAAAAAAwOD//wAAAAAmAAAAZAAAABYAAABMAAAAAAAAAAAAAAAEAAAAAAAAAAEAAABZWVkKAAAAACgAAAAoAAAAZAAAAGQAAAAAAAAAzMzMAAAAAABQAAAAUAAAAGQAAABkAAAAAAAAABcAAAAUAAAAAAAAAAAAAAD/fwAA/38AAAAAAAAJAAAABAAAAIK8UsUeAAAAaAAAAAAAAAAAAAAAAAAAAAAAAAAAAAAAECcAABAnAAAAAAAAAAAAAAAAAAAAAAAAAAAAAAAAAAAAAAAAAAAAABQAAAAAAAAAwMD/AAAAAABkAAAAMgAAAAAAAABkAAAAAAAAAH9/fwAKAAAAIgAAABgAAAAAAAAAAAAAAAAAAAAAAAAAAAAAAAAAAAAkAAAAJAAAAAAAAAAHAAAAAAAAAAAAAAAAAAAAAAAAAAAAAAAAAAAAf39/ACUAAABYAAAAAAAAAAAAAAAAAAAAAAAAAAAAAAAAAAAAAAAAAAAAAAAAAAAAAAAAAAAAAAA/AAAAAAAAAKCGAQAAAAAAAAAAAAAAAAAMAAAAAQAAAAAAAAAAAAAAAAAAAB8AAABUAAAAAAAABQAAAAEAAAAAAAAAAAAAAAAAAAAAAAAAAAAAAAAAAAAAAAAAAAAAAAJ/f38AAAAAA8zMzADAwP8Af39/AAAAAAAAAAAAAAAAAAAAAAAAAAAAIQAAABgAAAAUAAAAOAQAALgaAAD4JQAACDQAABAAAAAmAAAACAAAAL0/AAAAAAAA"/>
               </a:ext>
             </a:extLst>
           </p:cNvSpPr>
@@ -944,7 +943,7 @@
             <a:spLocks noGrp="1" noChangeArrowheads="1"/>
             <a:extLst>
               <a:ext uri="smNativeData">
-                <pr:smNativeData xmlns:pr="smNativeData" xmlns="smNativeData" val="SMDATA_15_EkJ5ZhMAAAAlAAAACwAAAA0AAAAACAcAADgEAAAoIwAAUBkAAAAAAAAAAAAAAAAAAAEAAABQAAAAAAAAAAAA4D8AAAAAAADgPwAAAAAAAOA/AAAAAAAA4D8AAAAAAADgPwAAAAAAAOA/AAAAAAAA4D8AAAAAAADgPwAAAAAAAOA/AAAAAAAA4D8CAAAAjAAAAAAAAAAAAAAAQoX0DP///wgAAAAAAAAAAAAAAAAAAAAAAAAAAAAAAAAAAAAAZAAAAAEAAABAAAAAAAAAAAAAAAAAAAAAAAAAAAAAAAAAAAAAAAAAAAAAAAAAAAAAAAAAAAAAAAAAAAAAAAAAAAAAAAAAAAAAAAAAAAAAAAAAAAAAAAAAAAAAAAAAAAAAFAAAADwAAAABAAAAAAAAAAAAAAAPAAAAAQAAACMAAAAjAAAAIwAAAB4AAAAAAAAASwAAAEsAAAAAAAAASwAAAEsAAAAVAAAAYAAAAAAAAAAAAAAADwAAACADAAAAAAAAAAAAAAEAAACgMgAAVgcAAKr4//8BAAAAf39/AAEAAABkAAAAAAAAABQAAABAHwAAAAAAACYAAAAAAAAAwOD//wAAAAAmAAAAZAAAABYAAABMAAAAAAAAAAAAAAAEAAAAAAAAAAEAAABZWVkKAAAAACgAAAAoAAAAZAAAAGQAAAAAAAAAzMzMAAAAAABQAAAAUAAAAGQAAABkAAAAAAAAABcAAAAUAAAAAAAAAAAAAAD/fwAA/38AAAAAAAAJAAAABAAAAAAAAAAeAAAAaAAAAAAAAAAAAAAAAAAAAAAAAAAAAAAAECcAABAnAAAAAAAAAAAAAAAAAAAAAAAAAAAAAAAAAAAAAAAAAAAAABQAAAAAAAAAwMD/AAAAAABkAAAAMgAAAAAAAABkAAAAAAAAAH9/fwAKAAAAIgAAABgAAAAAAAAAAAAAAAAAAAAAAAAAAAAAAAAAAAAkAAAAJAAAAAAAAAAHAAAAAAAAAAAAAAAAAAAAAAAAAAAAAAAAAAAAf39/ACUAAABYAAAAAAAAAAAAAAAAAAAAAAAAAAAAAAAAAAAAAAAAAAAAAAAAAAAAAAAAAAAAAAA/AAAAAAAAAKCGAQAAAAAAAAAAAAAAAAAMAAAAAQAAAAAAAAAAAAAAAAAAAB8AAABUAAAAAAAABQAAAAEAAAAAAAAAAAAAAAAAAAAAAAAAAAAAAAAAAAAAAAAAAAAAAAB/f38AAAAAA8zMzADAwP8Af39/AAAAAAAAAAAAAAAAAAAAAAAAAAAAIQAAABgAAAAUAAAACAcAADgEAAAoIwAAUBkAABAAAAAmAAAACAAAAAEPAAAAAAAA"/>
+                <pr:smNativeData xmlns:pr="smNativeData" xmlns="smNativeData" val="SMDATA_15_LkR5ZhMAAAAlAAAACwAAAA0AAAAACAcAADgEAAAoIwAAUBkAAAAAAAAAAAAAAAAAAAEAAABQAAAAAAAAAAAA4D8AAAAAAADgPwAAAAAAAOA/AAAAAAAA4D8AAAAAAADgPwAAAAAAAOA/AAAAAAAA4D8AAAAAAADgPwAAAAAAAOA/AAAAAAAA4D8CAAAAjAAAAAAAAAAAAAAAQoX0DP///wgAAAAAAAAAAAAAAAAAAAAAAAAAAAAAAAAAAAAAZAAAAAEAAABAAAAAAAAAAAAAAAAAAAAAAAAAAAAAAAAAAAAAAAAAAAAAAAAAAAAAAAAAAAAAAAAAAAAAAAAAAAAAAAAAAAAAAAAAAAAAAAAAAAAAAAAAAAAAAAAAAAAAFAAAADwAAAABAAAAAAAAAAAAAAAPAAAAAQAAACMAAAAjAAAAIwAAAB4AAAAAAAAASwAAAEsAAAAAAAAASwAAAEsAAAAVAAAAYAAAAAAAAAAAAAAADwAAACADAAAAAAAAAAAAAAEAAACgMgAAVgcAAKr4//8BAAAAf39/AAEAAABkAAAAAAAAABQAAABAHwAAAAAAACYAAAAAAAAAwOD//wAAAAAmAAAAZAAAABYAAABMAAAAAAAAAAAAAAAEAAAAAAAAAAEAAABZWVkKAAAAACgAAAAoAAAAZAAAAGQAAAAAAAAAzMzMAAAAAABQAAAAUAAAAGQAAABkAAAAAAAAABcAAAAUAAAAAAAAAAAAAAD/fwAA/38AAAAAAAAJAAAABAAAAAAAAAAeAAAAaAAAAAAAAAAAAAAAAAAAAAAAAAAAAAAAECcAABAnAAAAAAAAAAAAAAAAAAAAAAAAAAAAAAAAAAAAAAAAAAAAABQAAAAAAAAAwMD/AAAAAABkAAAAMgAAAAAAAABkAAAAAAAAAH9/fwAKAAAAIgAAABgAAAAAAAAAAAAAAAAAAAAAAAAAAAAAAAAAAAAkAAAAJAAAAAAAAAAHAAAAAAAAAAAAAAAAAAAAAAAAAAAAAAAAAAAAf39/ACUAAABYAAAAAAAAAAAAAAAAAAAAAAAAAAAAAAAAAAAAAAAAAAAAAAAAAAAAAAAAAAAAAAA/AAAAAAAAAKCGAQAAAAAAAAAAAAAAAAAMAAAAAQAAAAAAAAAAAAAAAAAAAB8AAABUAAAAAAAABQAAAAEAAAAAAAAAAAAAAAAAAAAAAAAAAAAAAAAAAAAAAAAAAAAAAAB/f38AAAAAA8zMzADAwP8Af39/AAAAAAAAAAAAAAAAAAAAAAAAAAAAIQAAABgAAAAUAAAACAcAADgEAAAoIwAAUBkAABAAAAAmAAAACAAAAAEPAAAAAAAA"/>
               </a:ext>
             </a:extLst>
           </p:cNvSpPr>
@@ -990,130 +989,7 @@
             <a:spLocks noGrp="1" noChangeArrowheads="1"/>
             <a:extLst>
               <a:ext uri="smNativeData">
-                <pr:smNativeData xmlns:pr="smNativeData" xmlns="smNativeData" val="SMDATA_15_EkJ5ZhMAAAAlAAAAZAAAAA0AAAAAkAAAAJAAAACQAAAAkAAAAAAAAAAAAAAAAAAAAAEAAABQAAAAAAAAAAAA4D8AAAAAAADgPwAAAAAAAOA/AAAAAAAA4D8AAAAAAADgPwAAAAAAAOA/AAAAAAAA4D8AAAAAAADgPwAAAAAAAOA/AAAAAAAA4D8CAAAAjAAAAAAAAAAAAAAAQoX0DP///wgAAAAAAAAAAAAAAAAAAAAAAAAAAAAAAAAAAAAAZAAAAAEAAABAAAAAAAAAAAAAAAAAAAAAAAAAAAAAAAAAAAAAAAAAAAAAAAAAAAAAAAAAAAAAAAAAAAAAAAAAAAAAAAAAAAAAAAAAAAAAAAAAAAAAAAAAAAAAAAAAAAAAFAAAADwAAAAAAAAAAAAAAAAAAAkUAAAAAQAAABQAAAAUAAAAFAAAAAEAAAAAAAAAZAAAAGQAAAAAAAAAZAAAAGQAAAAVAAAAYAAAAAAAAAAAAAAADwAAACADAAAAAAAAAAAAAAEAAACgMgAAVgcAAKr4//8BAAAAf39/AAEAAABkAAAAAAAAABQAAABAHwAAAAAAACYAAAAAAAAAwOD//wAAAAAmAAAAZAAAABYAAABMAAAAAAAAAAAAAAAEAAAAAAAAAAEAAABZWVkKAAAAACgAAAAoAAAAZAAAAGQAAAAAAAAAzMzMAAAAAABQAAAAUAAAAGQAAABkAAAAAAAAABcAAAAUAAAAAAAAAAAAAAD/fwAA/38AAAAAAAAJAAAABAAAAMGa1cUeAAAAaAAAAAAAAAAAAAAAAAAAAAAAAAAAAAAAECcAABAnAAAAAAAAAAAAAAAAAAAAAAAAAAAAAAAAAAAAAAAAAAAAABQAAAAAAAAAwMD/AAAAAABkAAAAMgAAAAAAAABkAAAAAAAAAH9/fwAKAAAAIgAAABgAAAAAAAAAAAAAAAAAAAAAAAAAAAAAAAAAAAAkAAAAJAAAAAAAAAAHAAAAAAAAAAAAAAAAAAAAAAAAAAAAAAAAAAAAf39/ACUAAABYAAAAAAAAAAAAAAAAAAAAAAAAAAAAAAAAAAAAAAAAAAAAAAAAAAAAAAAAAAAAAAA/AAAAAAAAAKCGAQAAAAAAAAAAAAAAAAAMAAAAAQAAAAAAAAAAAAAAAAAAAB8AAABUAAAAAAAABQAAAAEAAAAAAAAAAAAAAAAAAAAAAAAAAAAAAAAAAAAAAAAAAAAAAAJ/f38AAAAAA8zMzADAwP8Af39/AAAAAAAAAAAAAAAAAAAAAAAAAAAAIQAAABgAAAAUAAAAOAQAALgaAAD4JQAACDQAABAAAAAmAAAACAAAAL0/AAAAAAAA"/>
-              </a:ext>
-            </a:extLst>
-          </p:cNvSpPr>
-          <p:nvPr>
-            <p:ph type="body" idx="1"/>
-          </p:nvPr>
-        </p:nvSpPr>
-        <p:spPr>
-          <a:xfrm>
-            <a:off x="685800" y="4343400"/>
-            <a:ext cx="5486400" cy="4114800"/>
-          </a:xfrm>
-          <a:prstGeom prst="rect">
-            <a:avLst/>
-          </a:prstGeom>
-        </p:spPr>
-        <p:txBody>
-          <a:bodyPr vert="horz" wrap="square" lIns="91440" tIns="91440" rIns="91440" bIns="91440" numCol="1" spcCol="215900" anchor="t">
-            <a:prstTxWarp prst="textNoShape">
-              <a:avLst/>
-            </a:prstTxWarp>
-          </a:bodyPr>
-          <a:lstStyle/>
-          <a:p>
-            <a:pPr marL="0" indent="0" algn="l">
-              <a:spcBef>
-                <a:spcPts val="0"/>
-              </a:spcBef>
-              <a:spcAft>
-                <a:spcPts val="0"/>
-              </a:spcAft>
-              <a:buNone/>
-            </a:pPr>
-          </a:p>
-        </p:txBody>
-      </p:sp>
-    </p:spTree>
-  </p:cSld>
-  <p:clrMapOvr>
-    <a:overrideClrMapping bg1="lt1" tx1="dk1" bg2="dk2" tx2="lt2" accent1="accent1" accent2="accent2" accent3="accent3" accent4="accent4" accent5="accent5" accent6="accent6" hlink="hlink" folHlink="folHlink"/>
-  </p:clrMapOvr>
-</p:notes>
-</file>
-
-<file path=ppt/notesSlides/notesSlide12.xml><?xml version="1.0" encoding="utf-8"?>
-<p:notes xmlns:p="http://schemas.openxmlformats.org/presentationml/2006/main" xmlns:mc="http://schemas.openxmlformats.org/markup-compatibility/2006" xmlns:p14="http://schemas.microsoft.com/office/powerpoint/2010/main" xmlns:p15="http://schemas.microsoft.com/office/powerpoint/2012/main" xmlns:r="http://schemas.openxmlformats.org/officeDocument/2006/relationships" xmlns:a="http://schemas.openxmlformats.org/drawingml/2006/main" showMasterSp="0">
-  <p:cSld>
-    <p:bg>
-      <p:bgPr>
-        <a:solidFill>
-          <a:schemeClr val="bg1"/>
-        </a:solidFill>
-        <a:effectLst/>
-      </p:bgPr>
-    </p:bg>
-    <p:spTree>
-      <p:nvGrpSpPr>
-        <p:cNvPr id="1" name=""/>
-        <p:cNvGrpSpPr/>
-        <p:nvPr/>
-      </p:nvGrpSpPr>
-      <p:grpSpPr>
-        <a:xfrm>
-          <a:off x="0" y="0"/>
-          <a:ext cx="0" cy="0"/>
-          <a:chOff x="0" y="0"/>
-          <a:chExt cx="0" cy="0"/>
-        </a:xfrm>
-      </p:grpSpPr>
-      <p:sp>
-        <p:nvSpPr>
-          <p:cNvPr id="2" name="Google Shape;389;ge04b8b6756_0_137:notes"/>
-          <p:cNvSpPr>
-            <a:spLocks noGrp="1" noChangeArrowheads="1"/>
-            <a:extLst>
-              <a:ext uri="smNativeData">
-                <pr:smNativeData xmlns:pr="smNativeData" xmlns="smNativeData" val="SMDATA_15_EkJ5ZhMAAAAlAAAACwAAAA0AAAAACAcAADgEAAAoIwAAUBkAAAAAAAAAAAAAAAAAAAEAAABQAAAAAAAAAAAA4D8AAAAAAADgPwAAAAAAAOA/AAAAAAAA4D8AAAAAAADgPwAAAAAAAOA/AAAAAAAA4D8AAAAAAADgPwAAAAAAAOA/AAAAAAAA4D8CAAAAjAAAAAAAAAAAAAAAQoX0DP///wgAAAAAAAAAAAAAAAAAAAAAAAAAAAAAAAAAAAAAZAAAAAEAAABAAAAAAAAAAAAAAAAAAAAAAAAAAAAAAAAAAAAAAAAAAAAAAAAAAAAAAAAAAAAAAAAAAAAAAAAAAAAAAAAAAAAAAAAAAAAAAAAAAAAAAAAAAAAAAAAAAAAAFAAAADwAAAABAAAAAAAAAAAAAAAPAAAAAQAAACMAAAAjAAAAIwAAAB4AAAAAAAAASwAAAEsAAAAAAAAASwAAAEsAAAAVAAAAYAAAAAAAAAAAAAAADwAAACADAAAAAAAAAAAAAAEAAACgMgAAVgcAAKr4//8BAAAAf39/AAEAAABkAAAAAAAAABQAAABAHwAAAAAAACYAAAAAAAAAwOD//wAAAAAmAAAAZAAAABYAAABMAAAAAAAAAAAAAAAEAAAAAAAAAAEAAABZWVkKAAAAACgAAAAoAAAAZAAAAGQAAAAAAAAAzMzMAAAAAABQAAAAUAAAAGQAAABkAAAAAAAAABcAAAAUAAAAAAAAAAAAAAD/fwAA/38AAAAAAAAJAAAABAAAAAAAAAAeAAAAaAAAAAAAAAAAAAAAAAAAAAAAAAAAAAAAECcAABAnAAAAAAAAAAAAAAAAAAAAAAAAAAAAAAAAAAAAAAAAAAAAABQAAAAAAAAAwMD/AAAAAABkAAAAMgAAAAAAAABkAAAAAAAAAH9/fwAKAAAAIgAAABgAAAAAAAAAAAAAAAAAAAAAAAAAAAAAAAAAAAAkAAAAJAAAAAAAAAAHAAAAAAAAAAAAAAAAAAAAAAAAAAAAAAAAAAAAf39/ACUAAABYAAAAAAAAAAAAAAAAAAAAAAAAAAAAAAAAAAAAAAAAAAAAAAAAAAAAAAAAAAAAAAA/AAAAAAAAAKCGAQAAAAAAAAAAAAAAAAAMAAAAAQAAAAAAAAAAAAAAAAAAAB8AAABUAAAAAAAABQAAAAEAAAAAAAAAAAAAAAAAAAAAAAAAAAAAAAAAAAAAAAAAAAAAAAB/f38AAAAAA8zMzADAwP8Af39/AAAAAAAAAAAAAAAAAAAAAAAAAAAAIQAAABgAAAAUAAAACAcAADgEAAAoIwAAUBkAABAAAAAmAAAACAAAAAEPAAAAAAAA"/>
-              </a:ext>
-            </a:extLst>
-          </p:cNvSpPr>
-          <p:nvPr>
-            <p:ph type="sldImg" idx="2"/>
-          </p:nvPr>
-        </p:nvSpPr>
-        <p:spPr>
-          <a:xfrm>
-            <a:off x="1143000" y="685800"/>
-            <a:ext cx="4572000" cy="3429000"/>
-          </a:xfrm>
-          <a:custGeom>
-            <a:avLst/>
-            <a:gdLst/>
-            <a:ahLst/>
-            <a:cxnLst/>
-            <a:rect l="0" t="0" r="4572000" b="3429000"/>
-            <a:pathLst>
-              <a:path w="4572000" h="3429000" fill="none" extrusionOk="0">
-                <a:moveTo>
-                  <a:pt x="0" y="0"/>
-                </a:moveTo>
-                <a:lnTo>
-                  <a:pt x="4572000" y="0"/>
-                </a:lnTo>
-                <a:lnTo>
-                  <a:pt x="4572000" y="3429000"/>
-                </a:lnTo>
-                <a:lnTo>
-                  <a:pt x="0" y="3429000"/>
-                </a:lnTo>
-                <a:close/>
-              </a:path>
-            </a:pathLst>
-          </a:custGeom>
-        </p:spPr>
-      </p:sp>
-      <p:sp>
-        <p:nvSpPr>
-          <p:cNvPr id="3" name="Google Shape;390;ge04b8b6756_0_137:notes"/>
-          <p:cNvSpPr>
-            <a:spLocks noGrp="1" noChangeArrowheads="1"/>
-            <a:extLst>
-              <a:ext uri="smNativeData">
-                <pr:smNativeData xmlns:pr="smNativeData" xmlns="smNativeData" val="SMDATA_15_EkJ5ZhMAAAAlAAAAZAAAAA0AAAAAkAAAAJAAAACQAAAAkAAAAAAAAAAAAAAAAAAAAAEAAABQAAAAAAAAAAAA4D8AAAAAAADgPwAAAAAAAOA/AAAAAAAA4D8AAAAAAADgPwAAAAAAAOA/AAAAAAAA4D8AAAAAAADgPwAAAAAAAOA/AAAAAAAA4D8CAAAAjAAAAAAAAAAAAAAAQoX0DP///wgAAAAAAAAAAAAAAAAAAAAAAAAAAAAAAAAAAAAAZAAAAAEAAABAAAAAAAAAAAAAAAAAAAAAAAAAAAAAAAAAAAAAAAAAAAAAAAAAAAAAAAAAAAAAAAAAAAAAAAAAAAAAAAAAAAAAAAAAAAAAAAAAAAAAAAAAAAAAAAAAAAAAFAAAADwAAAAAAAAAAAAAAAAAAAkUAAAAAQAAABQAAAAUAAAAFAAAAAEAAAAAAAAAZAAAAGQAAAAAAAAAZAAAAGQAAAAVAAAAYAAAAAAAAAAAAAAADwAAACADAAAAAAAAAAAAAAEAAACgMgAAVgcAAKr4//8BAAAAf39/AAEAAABkAAAAAAAAABQAAABAHwAAAAAAACYAAAAAAAAAwOD//wAAAAAmAAAAZAAAABYAAABMAAAAAAAAAAAAAAAEAAAAAAAAAAEAAABZWVkKAAAAACgAAAAoAAAAZAAAAGQAAAAAAAAAzMzMAAAAAABQAAAAUAAAAGQAAABkAAAAAAAAABcAAAAUAAAAAAAAAAAAAAD/fwAA/38AAAAAAAAJAAAABAAAAAAAAAAeAAAAaAAAAAAAAAAAAAAAAAAAAAAAAAAAAAAAECcAABAnAAAAAAAAAAAAAAAAAAAAAAAAAAAAAAAAAAAAAAAAAAAAABQAAAAAAAAAwMD/AAAAAABkAAAAMgAAAAAAAABkAAAAAAAAAH9/fwAKAAAAIgAAABgAAAAAAAAAAAAAAAAAAAAAAAAAAAAAAAAAAAAkAAAAJAAAAAAAAAAHAAAAAAAAAAAAAAAAAAAAAAAAAAAAAAAAAAAAf39/ACUAAABYAAAAAAAAAAAAAAAAAAAAAAAAAAAAAAAAAAAAAAAAAAAAAAAAAAAAAAAAAAAAAAA/AAAAAAAAAKCGAQAAAAAAAAAAAAAAAAAMAAAAAQAAAAAAAAAAAAAAAAAAAB8AAABUAAAAAAAABQAAAAEAAAAAAAAAAAAAAAAAAAAAAAAAAAAAAAAAAAAAAAAAAAAAAAJ/f38AAAAAA8zMzADAwP8Af39/AAAAAAAAAAAAAAAAAAAAAAAAAAAAIQAAABgAAAAUAAAAOAQAALgaAAD4JQAACDQAABAAAAAmAAAACAAAAL0/AAAAAAAA"/>
+                <pr:smNativeData xmlns:pr="smNativeData" xmlns="smNativeData" val="SMDATA_15_LkR5ZhMAAAAlAAAAZAAAAA0AAAAAkAAAAJAAAACQAAAAkAAAAAAAAAAAAAAAAAAAAAEAAABQAAAAAAAAAAAA4D8AAAAAAADgPwAAAAAAAOA/AAAAAAAA4D8AAAAAAADgPwAAAAAAAOA/AAAAAAAA4D8AAAAAAADgPwAAAAAAAOA/AAAAAAAA4D8CAAAAjAAAAAAAAAAAAAAAQoX0DP///wgAAAAAAAAAAAAAAAAAAAAAAAAAAAAAAAAAAAAAZAAAAAEAAABAAAAAAAAAAAAAAAAAAAAAAAAAAAAAAAAAAAAAAAAAAAAAAAAAAAAAAAAAAAAAAAAAAAAAAAAAAAAAAAAAAAAAAAAAAAAAAAAAAAAAAAAAAAAAAAAAAAAAFAAAADwAAAAAAAAAAAAAAAAAAAkUAAAAAQAAABQAAAAUAAAAFAAAAAEAAAAAAAAAZAAAAGQAAAAAAAAAZAAAAGQAAAAVAAAAYAAAAAAAAAAAAAAADwAAACADAAAAAAAAAAAAAAEAAACgMgAAVgcAAKr4//8BAAAAf39/AAEAAABkAAAAAAAAABQAAABAHwAAAAAAACYAAAAAAAAAwOD//wAAAAAmAAAAZAAAABYAAABMAAAAAAAAAAAAAAAEAAAAAAAAAAEAAABZWVkKAAAAACgAAAAoAAAAZAAAAGQAAAAAAAAAzMzMAAAAAABQAAAAUAAAAGQAAABkAAAAAAAAABcAAAAUAAAAAAAAAAAAAAD/fwAA/38AAAAAAAAJAAAABAAAAMGa1cUeAAAAaAAAAAAAAAAAAAAAAAAAAAAAAAAAAAAAECcAABAnAAAAAAAAAAAAAAAAAAAAAAAAAAAAAAAAAAAAAAAAAAAAABQAAAAAAAAAwMD/AAAAAABkAAAAMgAAAAAAAABkAAAAAAAAAH9/fwAKAAAAIgAAABgAAAAAAAAAAAAAAAAAAAAAAAAAAAAAAAAAAAAkAAAAJAAAAAAAAAAHAAAAAAAAAAAAAAAAAAAAAAAAAAAAAAAAAAAAf39/ACUAAABYAAAAAAAAAAAAAAAAAAAAAAAAAAAAAAAAAAAAAAAAAAAAAAAAAAAAAAAAAAAAAAA/AAAAAAAAAKCGAQAAAAAAAAAAAAAAAAAMAAAAAQAAAAAAAAAAAAAAAAAAAB8AAABUAAAAAAAABQAAAAEAAAAAAAAAAAAAAAAAAAAAAAAAAAAAAAAAAAAAAAAAAAAAAAJ/f38AAAAAA8zMzADAwP8Af39/AAAAAAAAAAAAAAAAAAAAAAAAAAAAIQAAABgAAAAUAAAAOAQAALgaAAD4JQAACDQAABAAAAAmAAAACAAAAL0/AAAAAAAA"/>
               </a:ext>
             </a:extLst>
           </p:cNvSpPr>
@@ -1190,7 +1066,7 @@
             <a:spLocks noGrp="1" noChangeArrowheads="1"/>
             <a:extLst>
               <a:ext uri="smNativeData">
-                <pr:smNativeData xmlns:pr="smNativeData" xmlns="smNativeData" val="SMDATA_15_EkJ5ZhMAAAAlAAAACwAAAA0AAAAACAcAADgEAAAoIwAAUBkAAAAAAAAAAAAAAAAAAAEAAABQAAAAAAAAAAAA4D8AAAAAAADgPwAAAAAAAOA/AAAAAAAA4D8AAAAAAADgPwAAAAAAAOA/AAAAAAAA4D8AAAAAAADgPwAAAAAAAOA/AAAAAAAA4D8CAAAAjAAAAAAAAAAAAAAAQoX0DP///wgAAAAAAAAAAAAAAAAAAAAAAAAAAAAAAAAAAAAAZAAAAAEAAABAAAAAAAAAAAAAAAAAAAAAAAAAAAAAAAAAAAAAAAAAAAAAAAAAAAAAAAAAAAAAAAAAAAAAAAAAAAAAAAAAAAAAAAAAAAAAAAAAAAAAAAAAAAAAAAAAAAAAFAAAADwAAAABAAAAAAAAAAAAAAAPAAAAAQAAACMAAAAjAAAAIwAAAB4AAAAAAAAASwAAAEsAAAAAAAAASwAAAEsAAAAVAAAAYAAAAAAAAAAAAAAADwAAACADAAAAAAAAAAAAAAEAAACgMgAAVgcAAKr4//8BAAAAf39/AAEAAABkAAAAAAAAABQAAABAHwAAAAAAACYAAAAAAAAAwOD//wAAAAAmAAAAZAAAABYAAABMAAAAAAAAAAAAAAAEAAAAAAAAAAEAAABZWVkKAAAAACgAAAAoAAAAZAAAAGQAAAAAAAAAzMzMAAAAAABQAAAAUAAAAGQAAABkAAAAAAAAABcAAAAUAAAAAAAAAAAAAAD/fwAA/38AAAAAAAAJAAAABAAAAAAAAAAeAAAAaAAAAAAAAAAAAAAAAAAAAAAAAAAAAAAAECcAABAnAAAAAAAAAAAAAAAAAAAAAAAAAAAAAAAAAAAAAAAAAAAAABQAAAAAAAAAwMD/AAAAAABkAAAAMgAAAAAAAABkAAAAAAAAAH9/fwAKAAAAIgAAABgAAAAAAAAAAAAAAAAAAAAAAAAAAAAAAAAAAAAkAAAAJAAAAAAAAAAHAAAAAAAAAAAAAAAAAAAAAAAAAAAAAAAAAAAAf39/ACUAAABYAAAAAAAAAAAAAAAAAAAAAAAAAAAAAAAAAAAAAAAAAAAAAAAAAAAAAAAAAAAAAAA/AAAAAAAAAKCGAQAAAAAAAAAAAAAAAAAMAAAAAQAAAAAAAAAAAAAAAAAAAB8AAABUAAAAAAAABQAAAAEAAAAAAAAAAAAAAAAAAAAAAAAAAAAAAAAAAAAAAAAAAAAAAAB/f38AAAAAA8zMzADAwP8Af39/AAAAAAAAAAAAAAAAAAAAAAAAAAAAIQAAABgAAAAUAAAACAcAADgEAAAoIwAAUBkAABAAAAAmAAAACAAAAAEPAAAAAAAA"/>
+                <pr:smNativeData xmlns:pr="smNativeData" xmlns="smNativeData" val="SMDATA_15_LkR5ZhMAAAAlAAAACwAAAA0AAAAACAcAADgEAAAoIwAAUBkAAAAAAAAAAAAAAAAAAAEAAABQAAAAAAAAAAAA4D8AAAAAAADgPwAAAAAAAOA/AAAAAAAA4D8AAAAAAADgPwAAAAAAAOA/AAAAAAAA4D8AAAAAAADgPwAAAAAAAOA/AAAAAAAA4D8CAAAAjAAAAAAAAAAAAAAAQoX0DP///wgAAAAAAAAAAAAAAAAAAAAAAAAAAAAAAAAAAAAAZAAAAAEAAABAAAAAAAAAAAAAAAAAAAAAAAAAAAAAAAAAAAAAAAAAAAAAAAAAAAAAAAAAAAAAAAAAAAAAAAAAAAAAAAAAAAAAAAAAAAAAAAAAAAAAAAAAAAAAAAAAAAAAFAAAADwAAAABAAAAAAAAAAAAAAAPAAAAAQAAACMAAAAjAAAAIwAAAB4AAAAAAAAASwAAAEsAAAAAAAAASwAAAEsAAAAVAAAAYAAAAAAAAAAAAAAADwAAACADAAAAAAAAAAAAAAEAAACgMgAAVgcAAKr4//8BAAAAf39/AAEAAABkAAAAAAAAABQAAABAHwAAAAAAACYAAAAAAAAAwOD//wAAAAAmAAAAZAAAABYAAABMAAAAAAAAAAAAAAAEAAAAAAAAAAEAAABZWVkKAAAAACgAAAAoAAAAZAAAAGQAAAAAAAAAzMzMAAAAAABQAAAAUAAAAGQAAABkAAAAAAAAABcAAAAUAAAAAAAAAAAAAAD/fwAA/38AAAAAAAAJAAAABAAAAAAAAAAeAAAAaAAAAAAAAAAAAAAAAAAAAAAAAAAAAAAAECcAABAnAAAAAAAAAAAAAAAAAAAAAAAAAAAAAAAAAAAAAAAAAAAAABQAAAAAAAAAwMD/AAAAAABkAAAAMgAAAAAAAABkAAAAAAAAAH9/fwAKAAAAIgAAABgAAAAAAAAAAAAAAAAAAAAAAAAAAAAAAAAAAAAkAAAAJAAAAAAAAAAHAAAAAAAAAAAAAAAAAAAAAAAAAAAAAAAAAAAAf39/ACUAAABYAAAAAAAAAAAAAAAAAAAAAAAAAAAAAAAAAAAAAAAAAAAAAAAAAAAAAAAAAAAAAAA/AAAAAAAAAKCGAQAAAAAAAAAAAAAAAAAMAAAAAQAAAAAAAAAAAAAAAAAAAB8AAABUAAAAAAAABQAAAAEAAAAAAAAAAAAAAAAAAAAAAAAAAAAAAAAAAAAAAAAAAAAAAAB/f38AAAAAA8zMzADAwP8Af39/AAAAAAAAAAAAAAAAAAAAAAAAAAAAIQAAABgAAAAUAAAACAcAADgEAAAoIwAAUBkAABAAAAAmAAAACAAAAAEPAAAAAAAA"/>
               </a:ext>
             </a:extLst>
           </p:cNvSpPr>
@@ -1236,7 +1112,7 @@
             <a:spLocks noGrp="1" noChangeArrowheads="1"/>
             <a:extLst>
               <a:ext uri="smNativeData">
-                <pr:smNativeData xmlns:pr="smNativeData" xmlns="smNativeData" val="SMDATA_15_EkJ5ZhMAAAAlAAAAZAAAAA0AAAAAkAAAAJAAAACQAAAAkAAAAAAAAAAAAAAAAAAAAAEAAABQAAAAAAAAAAAA4D8AAAAAAADgPwAAAAAAAOA/AAAAAAAA4D8AAAAAAADgPwAAAAAAAOA/AAAAAAAA4D8AAAAAAADgPwAAAAAAAOA/AAAAAAAA4D8CAAAAjAAAAAAAAAAAAAAAQoX0DP///wgAAAAAAAAAAAAAAAAAAAAAAAAAAAAAAAAAAAAAZAAAAAEAAABAAAAAAAAAAAAAAAAAAAAAAAAAAAAAAAAAAAAAAAAAAAAAAAAAAAAAAAAAAAAAAAAAAAAAAAAAAAAAAAAAAAAAAAAAAAAAAAAAAAAAAAAAAAAAAAAAAAAAFAAAADwAAAAAAAAAAAAAAAAAAAkUAAAAAQAAABQAAAAUAAAAFAAAAAEAAAAAAAAAZAAAAGQAAAAAAAAAZAAAAGQAAAAVAAAAYAAAAAAAAAAAAAAADwAAACADAAAAAAAAAAAAAAEAAACgMgAAVgcAAKr4//8BAAAAf39/AAEAAABkAAAAAAAAABQAAABAHwAAAAAAACYAAAAAAAAAwOD//wAAAAAmAAAAZAAAABYAAABMAAAAAAAAAAAAAAAEAAAAAAAAAAEAAABZWVkKAAAAACgAAAAoAAAAZAAAAGQAAAAAAAAAzMzMAAAAAABQAAAAUAAAAGQAAABkAAAAAAAAABcAAAAUAAAAAAAAAAAAAAD/fwAA/38AAAAAAAAJAAAABAAAAF8AYAAeAAAAaAAAAAAAAAAAAAAAAAAAAAAAAAAAAAAAECcAABAnAAAAAAAAAAAAAAAAAAAAAAAAAAAAAAAAAAAAAAAAAAAAABQAAAAAAAAAwMD/AAAAAABkAAAAMgAAAAAAAABkAAAAAAAAAH9/fwAKAAAAIgAAABgAAAAAAAAAAAAAAAAAAAAAAAAAAAAAAAAAAAAkAAAAJAAAAAAAAAAHAAAAAAAAAAAAAAAAAAAAAAAAAAAAAAAAAAAAf39/ACUAAABYAAAAAAAAAAAAAAAAAAAAAAAAAAAAAAAAAAAAAAAAAAAAAAAAAAAAAAAAAAAAAAA/AAAAAAAAAKCGAQAAAAAAAAAAAAAAAAAMAAAAAQAAAAAAAAAAAAAAAAAAAB8AAABUAAAAAAAABQAAAAEAAAAAAAAAAAAAAAAAAAAAAAAAAAAAAAAAAAAAAAAAAAAAAAJ/f38AAAAAA8zMzADAwP8Af39/AAAAAAAAAAAAAAAAAAAAAAAAAAAAIQAAABgAAAAUAAAAOAQAALgaAAD4JQAACDQAABAAAAAmAAAACAAAAL0/AAAAAAAA"/>
+                <pr:smNativeData xmlns:pr="smNativeData" xmlns="smNativeData" val="SMDATA_15_LkR5ZhMAAAAlAAAAZAAAAA0AAAAAkAAAAJAAAACQAAAAkAAAAAAAAAAAAAAAAAAAAAEAAABQAAAAAAAAAAAA4D8AAAAAAADgPwAAAAAAAOA/AAAAAAAA4D8AAAAAAADgPwAAAAAAAOA/AAAAAAAA4D8AAAAAAADgPwAAAAAAAOA/AAAAAAAA4D8CAAAAjAAAAAAAAAAAAAAAQoX0DP///wgAAAAAAAAAAAAAAAAAAAAAAAAAAAAAAAAAAAAAZAAAAAEAAABAAAAAAAAAAAAAAAAAAAAAAAAAAAAAAAAAAAAAAAAAAAAAAAAAAAAAAAAAAAAAAAAAAAAAAAAAAAAAAAAAAAAAAAAAAAAAAAAAAAAAAAAAAAAAAAAAAAAAFAAAADwAAAAAAAAAAAAAAAAAAAkUAAAAAQAAABQAAAAUAAAAFAAAAAEAAAAAAAAAZAAAAGQAAAAAAAAAZAAAAGQAAAAVAAAAYAAAAAAAAAAAAAAADwAAACADAAAAAAAAAAAAAAEAAACgMgAAVgcAAKr4//8BAAAAf39/AAEAAABkAAAAAAAAABQAAABAHwAAAAAAACYAAAAAAAAAwOD//wAAAAAmAAAAZAAAABYAAABMAAAAAAAAAAAAAAAEAAAAAAAAAAEAAABZWVkKAAAAACgAAAAoAAAAZAAAAGQAAAAAAAAAzMzMAAAAAABQAAAAUAAAAGQAAABkAAAAAAAAABcAAAAUAAAAAAAAAAAAAAD/fwAA/38AAAAAAAAJAAAABAAAAF8AYAAeAAAAaAAAAAAAAAAAAAAAAAAAAAAAAAAAAAAAECcAABAnAAAAAAAAAAAAAAAAAAAAAAAAAAAAAAAAAAAAAAAAAAAAABQAAAAAAAAAwMD/AAAAAABkAAAAMgAAAAAAAABkAAAAAAAAAH9/fwAKAAAAIgAAABgAAAAAAAAAAAAAAAAAAAAAAAAAAAAAAAAAAAAkAAAAJAAAAAAAAAAHAAAAAAAAAAAAAAAAAAAAAAAAAAAAAAAAAAAAf39/ACUAAABYAAAAAAAAAAAAAAAAAAAAAAAAAAAAAAAAAAAAAAAAAAAAAAAAAAAAAAAAAAAAAAA/AAAAAAAAAKCGAQAAAAAAAAAAAAAAAAAMAAAAAQAAAAAAAAAAAAAAAAAAAB8AAABUAAAAAAAABQAAAAEAAAAAAAAAAAAAAAAAAAAAAAAAAAAAAAAAAAAAAAAAAAAAAAJ/f38AAAAAA8zMzADAwP8Af39/AAAAAAAAAAAAAAAAAAAAAAAAAAAAIQAAABgAAAAUAAAAOAQAALgaAAD4JQAACDQAABAAAAAmAAAACAAAAL0/AAAAAAAA"/>
               </a:ext>
             </a:extLst>
           </p:cNvSpPr>
@@ -1313,7 +1189,7 @@
             <a:spLocks noGrp="1" noChangeArrowheads="1"/>
             <a:extLst>
               <a:ext uri="smNativeData">
-                <pr:smNativeData xmlns:pr="smNativeData" xmlns="smNativeData" val="SMDATA_15_EkJ5ZhMAAAAlAAAACwAAAA0AAAAACAcAADgEAAAoIwAAUBkAAAAAAAAAAAAAAAAAAAEAAABQAAAAAAAAAAAA4D8AAAAAAADgPwAAAAAAAOA/AAAAAAAA4D8AAAAAAADgPwAAAAAAAOA/AAAAAAAA4D8AAAAAAADgPwAAAAAAAOA/AAAAAAAA4D8CAAAAjAAAAAAAAAAAAAAAQoX0DP///wgAAAAAAAAAAAAAAAAAAAAAAAAAAAAAAAAAAAAAZAAAAAEAAABAAAAAAAAAAAAAAAAAAAAAAAAAAAAAAAAAAAAAAAAAAAAAAAAAAAAAAAAAAAAAAAAAAAAAAAAAAAAAAAAAAAAAAAAAAAAAAAAAAAAAAAAAAAAAAAAAAAAAFAAAADwAAAABAAAAAAAAAAAAAAAPAAAAAQAAACMAAAAjAAAAIwAAAB4AAAAAAAAASwAAAEsAAAAAAAAASwAAAEsAAAAVAAAAYAAAAAAAAAAAAAAADwAAACADAAAAAAAAAAAAAAEAAACgMgAAVgcAAKr4//8BAAAAf39/AAEAAABkAAAAAAAAABQAAABAHwAAAAAAACYAAAAAAAAAwOD//wAAAAAmAAAAZAAAABYAAABMAAAAAAAAAAAAAAAEAAAAAAAAAAEAAABZWVkKAAAAACgAAAAoAAAAZAAAAGQAAAAAAAAAzMzMAAAAAABQAAAAUAAAAGQAAABkAAAAAAAAABcAAAAUAAAAAAAAAAAAAAD/fwAA/38AAAAAAAAJAAAABAAAAAAAAAAeAAAAaAAAAAAAAAAAAAAAAAAAAAAAAAAAAAAAECcAABAnAAAAAAAAAAAAAAAAAAAAAAAAAAAAAAAAAAAAAAAAAAAAABQAAAAAAAAAwMD/AAAAAABkAAAAMgAAAAAAAABkAAAAAAAAAH9/fwAKAAAAIgAAABgAAAAAAAAAAAAAAAAAAAAAAAAAAAAAAAAAAAAkAAAAJAAAAAAAAAAHAAAAAAAAAAAAAAAAAAAAAAAAAAAAAAAAAAAAf39/ACUAAABYAAAAAAAAAAAAAAAAAAAAAAAAAAAAAAAAAAAAAAAAAAAAAAAAAAAAAAAAAAAAAAA/AAAAAAAAAKCGAQAAAAAAAAAAAAAAAAAMAAAAAQAAAAAAAAAAAAAAAAAAAB8AAABUAAAAAAAABQAAAAEAAAAAAAAAAAAAAAAAAAAAAAAAAAAAAAAAAAAAAAAAAAAAAAB/f38AAAAAA8zMzADAwP8Af39/AAAAAAAAAAAAAAAAAAAAAAAAAAAAIQAAABgAAAAUAAAACAcAADgEAAAoIwAAUBkAABAAAAAmAAAACAAAAAEPAAAAAAAA"/>
+                <pr:smNativeData xmlns:pr="smNativeData" xmlns="smNativeData" val="SMDATA_15_LkR5ZhMAAAAlAAAACwAAAA0AAAAACAcAADgEAAAoIwAAUBkAAAAAAAAAAAAAAAAAAAEAAABQAAAAAAAAAAAA4D8AAAAAAADgPwAAAAAAAOA/AAAAAAAA4D8AAAAAAADgPwAAAAAAAOA/AAAAAAAA4D8AAAAAAADgPwAAAAAAAOA/AAAAAAAA4D8CAAAAjAAAAAAAAAAAAAAAQoX0DP///wgAAAAAAAAAAAAAAAAAAAAAAAAAAAAAAAAAAAAAZAAAAAEAAABAAAAAAAAAAAAAAAAAAAAAAAAAAAAAAAAAAAAAAAAAAAAAAAAAAAAAAAAAAAAAAAAAAAAAAAAAAAAAAAAAAAAAAAAAAAAAAAAAAAAAAAAAAAAAAAAAAAAAFAAAADwAAAABAAAAAAAAAAAAAAAPAAAAAQAAACMAAAAjAAAAIwAAAB4AAAAAAAAASwAAAEsAAAAAAAAASwAAAEsAAAAVAAAAYAAAAAAAAAAAAAAADwAAACADAAAAAAAAAAAAAAEAAACgMgAAVgcAAKr4//8BAAAAf39/AAEAAABkAAAAAAAAABQAAABAHwAAAAAAACYAAAAAAAAAwOD//wAAAAAmAAAAZAAAABYAAABMAAAAAAAAAAAAAAAEAAAAAAAAAAEAAABZWVkKAAAAACgAAAAoAAAAZAAAAGQAAAAAAAAAzMzMAAAAAABQAAAAUAAAAGQAAABkAAAAAAAAABcAAAAUAAAAAAAAAAAAAAD/fwAA/38AAAAAAAAJAAAABAAAAAAAAAAeAAAAaAAAAAAAAAAAAAAAAAAAAAAAAAAAAAAAECcAABAnAAAAAAAAAAAAAAAAAAAAAAAAAAAAAAAAAAAAAAAAAAAAABQAAAAAAAAAwMD/AAAAAABkAAAAMgAAAAAAAABkAAAAAAAAAH9/fwAKAAAAIgAAABgAAAAAAAAAAAAAAAAAAAAAAAAAAAAAAAAAAAAkAAAAJAAAAAAAAAAHAAAAAAAAAAAAAAAAAAAAAAAAAAAAAAAAAAAAf39/ACUAAABYAAAAAAAAAAAAAAAAAAAAAAAAAAAAAAAAAAAAAAAAAAAAAAAAAAAAAAAAAAAAAAA/AAAAAAAAAKCGAQAAAAAAAAAAAAAAAAAMAAAAAQAAAAAAAAAAAAAAAAAAAB8AAABUAAAAAAAABQAAAAEAAAAAAAAAAAAAAAAAAAAAAAAAAAAAAAAAAAAAAAAAAAAAAAB/f38AAAAAA8zMzADAwP8Af39/AAAAAAAAAAAAAAAAAAAAAAAAAAAAIQAAABgAAAAUAAAACAcAADgEAAAoIwAAUBkAABAAAAAmAAAACAAAAAEPAAAAAAAA"/>
               </a:ext>
             </a:extLst>
           </p:cNvSpPr>
@@ -1359,7 +1235,7 @@
             <a:spLocks noGrp="1" noChangeArrowheads="1"/>
             <a:extLst>
               <a:ext uri="smNativeData">
-                <pr:smNativeData xmlns:pr="smNativeData" xmlns="smNativeData" val="SMDATA_15_EkJ5ZhMAAAAlAAAAZAAAAA0AAAAAkAAAAJAAAACQAAAAkAAAAAAAAAAAAAAAAAAAAAEAAABQAAAAAAAAAAAA4D8AAAAAAADgPwAAAAAAAOA/AAAAAAAA4D8AAAAAAADgPwAAAAAAAOA/AAAAAAAA4D8AAAAAAADgPwAAAAAAAOA/AAAAAAAA4D8CAAAAjAAAAAAAAAAAAAAAQoX0DP///wgAAAAAAAAAAAAAAAAAAAAAAAAAAAAAAAAAAAAAZAAAAAEAAABAAAAAAAAAAAAAAAAAAAAAAAAAAAAAAAAAAAAAAAAAAAAAAAAAAAAAAAAAAAAAAAAAAAAAAAAAAAAAAAAAAAAAAAAAAAAAAAAAAAAAAAAAAAAAAAAAAAAAFAAAADwAAAAAAAAAAAAAAAAAAAkUAAAAAQAAABQAAAAUAAAAFAAAAAEAAAAAAAAAZAAAAGQAAAAAAAAAZAAAAGQAAAAVAAAAYAAAAAAAAAAAAAAADwAAACADAAAAAAAAAAAAAAEAAACgMgAAVgcAAKr4//8BAAAAf39/AAEAAABkAAAAAAAAABQAAABAHwAAAAAAACYAAAAAAAAAwOD//wAAAAAmAAAAZAAAABYAAABMAAAAAAAAAAAAAAAEAAAAAAAAAAEAAABZWVkKAAAAACgAAAAoAAAAZAAAAGQAAAAAAAAAzMzMAAAAAABQAAAAUAAAAGQAAABkAAAAAAAAABcAAAAUAAAAAAAAAAAAAAD/fwAA/38AAAAAAAAJAAAABAAAAM/Y+1ceAAAAaAAAAAAAAAAAAAAAAAAAAAAAAAAAAAAAECcAABAnAAAAAAAAAAAAAAAAAAAAAAAAAAAAAAAAAAAAAAAAAAAAABQAAAAAAAAAwMD/AAAAAABkAAAAMgAAAAAAAABkAAAAAAAAAH9/fwAKAAAAIgAAABgAAAAAAAAAAAAAAAAAAAAAAAAAAAAAAAAAAAAkAAAAJAAAAAAAAAAHAAAAAAAAAAAAAAAAAAAAAAAAAAAAAAAAAAAAf39/ACUAAABYAAAAAAAAAAAAAAAAAAAAAAAAAAAAAAAAAAAAAAAAAAAAAAAAAAAAAAAAAAAAAAA/AAAAAAAAAKCGAQAAAAAAAAAAAAAAAAAMAAAAAQAAAAAAAAAAAAAAAAAAAB8AAABUAAAAAAAABQAAAAEAAAAAAAAAAAAAAAAAAAAAAAAAAAAAAAAAAAAAAAAAAAAAAAJ/f38AAAAAA8zMzADAwP8Af39/AAAAAAAAAAAAAAAAAAAAAAAAAAAAIQAAABgAAAAUAAAAOAQAALgaAAD4JQAACDQAABAAAAAmAAAACAAAAL0/AAAAAAAA"/>
+                <pr:smNativeData xmlns:pr="smNativeData" xmlns="smNativeData" val="SMDATA_15_LkR5ZhMAAAAlAAAAZAAAAA0AAAAAkAAAAJAAAACQAAAAkAAAAAAAAAAAAAAAAAAAAAEAAABQAAAAAAAAAAAA4D8AAAAAAADgPwAAAAAAAOA/AAAAAAAA4D8AAAAAAADgPwAAAAAAAOA/AAAAAAAA4D8AAAAAAADgPwAAAAAAAOA/AAAAAAAA4D8CAAAAjAAAAAAAAAAAAAAAQoX0DP///wgAAAAAAAAAAAAAAAAAAAAAAAAAAAAAAAAAAAAAZAAAAAEAAABAAAAAAAAAAAAAAAAAAAAAAAAAAAAAAAAAAAAAAAAAAAAAAAAAAAAAAAAAAAAAAAAAAAAAAAAAAAAAAAAAAAAAAAAAAAAAAAAAAAAAAAAAAAAAAAAAAAAAFAAAADwAAAAAAAAAAAAAAAAAAAkUAAAAAQAAABQAAAAUAAAAFAAAAAEAAAAAAAAAZAAAAGQAAAAAAAAAZAAAAGQAAAAVAAAAYAAAAAAAAAAAAAAADwAAACADAAAAAAAAAAAAAAEAAACgMgAAVgcAAKr4//8BAAAAf39/AAEAAABkAAAAAAAAABQAAABAHwAAAAAAACYAAAAAAAAAwOD//wAAAAAmAAAAZAAAABYAAABMAAAAAAAAAAAAAAAEAAAAAAAAAAEAAABZWVkKAAAAACgAAAAoAAAAZAAAAGQAAAAAAAAAzMzMAAAAAABQAAAAUAAAAGQAAABkAAAAAAAAABcAAAAUAAAAAAAAAAAAAAD/fwAA/38AAAAAAAAJAAAABAAAAM/Y+1ceAAAAaAAAAAAAAAAAAAAAAAAAAAAAAAAAAAAAECcAABAnAAAAAAAAAAAAAAAAAAAAAAAAAAAAAAAAAAAAAAAAAAAAABQAAAAAAAAAwMD/AAAAAABkAAAAMgAAAAAAAABkAAAAAAAAAH9/fwAKAAAAIgAAABgAAAAAAAAAAAAAAAAAAAAAAAAAAAAAAAAAAAAkAAAAJAAAAAAAAAAHAAAAAAAAAAAAAAAAAAAAAAAAAAAAAAAAAAAAf39/ACUAAABYAAAAAAAAAAAAAAAAAAAAAAAAAAAAAAAAAAAAAAAAAAAAAAAAAAAAAAAAAAAAAAA/AAAAAAAAAKCGAQAAAAAAAAAAAAAAAAAMAAAAAQAAAAAAAAAAAAAAAAAAAB8AAABUAAAAAAAABQAAAAEAAAAAAAAAAAAAAAAAAAAAAAAAAAAAAAAAAAAAAAAAAAAAAAJ/f38AAAAAA8zMzADAwP8Af39/AAAAAAAAAAAAAAAAAAAAAAAAAAAAIQAAABgAAAAUAAAAOAQAALgaAAD4JQAACDQAABAAAAAmAAAACAAAAL0/AAAAAAAA"/>
               </a:ext>
             </a:extLst>
           </p:cNvSpPr>
@@ -1436,7 +1312,7 @@
             <a:spLocks noGrp="1" noChangeArrowheads="1"/>
             <a:extLst>
               <a:ext uri="smNativeData">
-                <pr:smNativeData xmlns:pr="smNativeData" xmlns="smNativeData" val="SMDATA_15_EkJ5ZhMAAAAlAAAACwAAAA0AAAAACAcAADgEAAAoIwAAUBkAAAAAAAAAAAAAAAAAAAEAAABQAAAAAAAAAAAA4D8AAAAAAADgPwAAAAAAAOA/AAAAAAAA4D8AAAAAAADgPwAAAAAAAOA/AAAAAAAA4D8AAAAAAADgPwAAAAAAAOA/AAAAAAAA4D8CAAAAjAAAAAAAAAAAAAAAQoX0DP///wgAAAAAAAAAAAAAAAAAAAAAAAAAAAAAAAAAAAAAZAAAAAEAAABAAAAAAAAAAAAAAAAAAAAAAAAAAAAAAAAAAAAAAAAAAAAAAAAAAAAAAAAAAAAAAAAAAAAAAAAAAAAAAAAAAAAAAAAAAAAAAAAAAAAAAAAAAAAAAAAAAAAAFAAAADwAAAABAAAAAAAAAAAAAAAPAAAAAQAAACMAAAAjAAAAIwAAAB4AAAAAAAAASwAAAEsAAAAAAAAASwAAAEsAAAAVAAAAYAAAAAAAAAAAAAAADwAAACADAAAAAAAAAAAAAAEAAACgMgAAVgcAAKr4//8BAAAAf39/AAEAAABkAAAAAAAAABQAAABAHwAAAAAAACYAAAAAAAAAwOD//wAAAAAmAAAAZAAAABYAAABMAAAAAAAAAAAAAAAEAAAAAAAAAAEAAABZWVkKAAAAACgAAAAoAAAAZAAAAGQAAAAAAAAAzMzMAAAAAABQAAAAUAAAAGQAAABkAAAAAAAAABcAAAAUAAAAAAAAAAAAAAD/fwAA/38AAAAAAAAJAAAABAAAAEXJ0L8eAAAAaAAAAAAAAAAAAAAAAAAAAAAAAAAAAAAAECcAABAnAAAAAAAAAAAAAAAAAAAAAAAAAAAAAAAAAAAAAAAAAAAAABQAAAAAAAAAwMD/AAAAAABkAAAAMgAAAAAAAABkAAAAAAAAAH9/fwAKAAAAIgAAABgAAAAAAAAAAAAAAAAAAAAAAAAAAAAAAAAAAAAkAAAAJAAAAAAAAAAHAAAAAAAAAAAAAAAAAAAAAAAAAAAAAAAAAAAAf39/ACUAAABYAAAAAAAAAAAAAAAAAAAAAAAAAAAAAAAAAAAAAAAAAAAAAAAAAAAAAAAAAAAAAAA/AAAAAAAAAKCGAQAAAAAAAAAAAAAAAAAMAAAAAQAAAAAAAAAAAAAAAAAAAB8AAABUAAAAAAAABQAAAAEAAAAAAAAAAAAAAAAAAAAAAAAAAAAAAAAAAAAAAAAAAAAAAAB/f38AAAAAA8zMzADAwP8Af39/AAAAAAAAAAAAAAAAAAAAAAAAAAAAIQAAABgAAAAUAAAACAcAADgEAAAoIwAAUBkAABAAAAAmAAAACAAAAAEPAAAAAAAA"/>
+                <pr:smNativeData xmlns:pr="smNativeData" xmlns="smNativeData" val="SMDATA_15_LkR5ZhMAAAAlAAAACwAAAA0AAAAACAcAADgEAAAoIwAAUBkAAAAAAAAAAAAAAAAAAAEAAABQAAAAAAAAAAAA4D8AAAAAAADgPwAAAAAAAOA/AAAAAAAA4D8AAAAAAADgPwAAAAAAAOA/AAAAAAAA4D8AAAAAAADgPwAAAAAAAOA/AAAAAAAA4D8CAAAAjAAAAAAAAAAAAAAAQoX0DP///wgAAAAAAAAAAAAAAAAAAAAAAAAAAAAAAAAAAAAAZAAAAAEAAABAAAAAAAAAAAAAAAAAAAAAAAAAAAAAAAAAAAAAAAAAAAAAAAAAAAAAAAAAAAAAAAAAAAAAAAAAAAAAAAAAAAAAAAAAAAAAAAAAAAAAAAAAAAAAAAAAAAAAFAAAADwAAAABAAAAAAAAAAAAAAAPAAAAAQAAACMAAAAjAAAAIwAAAB4AAAAAAAAASwAAAEsAAAAAAAAASwAAAEsAAAAVAAAAYAAAAAAAAAAAAAAADwAAACADAAAAAAAAAAAAAAEAAACgMgAAVgcAAKr4//8BAAAAf39/AAEAAABkAAAAAAAAABQAAABAHwAAAAAAACYAAAAAAAAAwOD//wAAAAAmAAAAZAAAABYAAABMAAAAAAAAAAAAAAAEAAAAAAAAAAEAAABZWVkKAAAAACgAAAAoAAAAZAAAAGQAAAAAAAAAzMzMAAAAAABQAAAAUAAAAGQAAABkAAAAAAAAABcAAAAUAAAAAAAAAAAAAAD/fwAA/38AAAAAAAAJAAAABAAAAEXJ0L8eAAAAaAAAAAAAAAAAAAAAAAAAAAAAAAAAAAAAECcAABAnAAAAAAAAAAAAAAAAAAAAAAAAAAAAAAAAAAAAAAAAAAAAABQAAAAAAAAAwMD/AAAAAABkAAAAMgAAAAAAAABkAAAAAAAAAH9/fwAKAAAAIgAAABgAAAAAAAAAAAAAAAAAAAAAAAAAAAAAAAAAAAAkAAAAJAAAAAAAAAAHAAAAAAAAAAAAAAAAAAAAAAAAAAAAAAAAAAAAf39/ACUAAABYAAAAAAAAAAAAAAAAAAAAAAAAAAAAAAAAAAAAAAAAAAAAAAAAAAAAAAAAAAAAAAA/AAAAAAAAAKCGAQAAAAAAAAAAAAAAAAAMAAAAAQAAAAAAAAAAAAAAAAAAAB8AAABUAAAAAAAABQAAAAEAAAAAAAAAAAAAAAAAAAAAAAAAAAAAAAAAAAAAAAAAAAAAAAB/f38AAAAAA8zMzADAwP8Af39/AAAAAAAAAAAAAAAAAAAAAAAAAAAAIQAAABgAAAAUAAAACAcAADgEAAAoIwAAUBkAABAAAAAmAAAACAAAAAEPAAAAAAAA"/>
               </a:ext>
             </a:extLst>
           </p:cNvSpPr>
@@ -1482,7 +1358,7 @@
             <a:spLocks noGrp="1" noChangeArrowheads="1"/>
             <a:extLst>
               <a:ext uri="smNativeData">
-                <pr:smNativeData xmlns:pr="smNativeData" xmlns="smNativeData" val="SMDATA_15_EkJ5ZhMAAAAlAAAAZAAAAA0AAAAAkAAAAJAAAACQAAAAkAAAAAAAAAAAAAAAAAAAAAEAAABQAAAAAAAAAAAA4D8AAAAAAADgPwAAAAAAAOA/AAAAAAAA4D8AAAAAAADgPwAAAAAAAOA/AAAAAAAA4D8AAAAAAADgPwAAAAAAAOA/AAAAAAAA4D8CAAAAjAAAAAAAAAAAAAAAQoX0DP///wgAAAAAAAAAAAAAAAAAAAAAAAAAAAAAAAAAAAAAZAAAAAEAAABAAAAAAAAAAAAAAAAAAAAAAAAAAAAAAAAAAAAAAAAAAAAAAAAAAAAAAAAAAAAAAAAAAAAAAAAAAAAAAAAAAAAAAAAAAAAAAAAAAAAAAAAAAAAAAAAAAAAAFAAAADwAAAAAAAAAAAAAAAAAAAkUAAAAAQAAABQAAAAUAAAAFAAAAAEAAAAAAAAAZAAAAGQAAAAAAAAAZAAAAGQAAAAVAAAAYAAAAAAAAAAAAAAADwAAACADAAAAAAAAAAAAAAEAAACgMgAAVgcAAKr4//8BAAAAf39/AAEAAABkAAAAAAAAABQAAABAHwAAAAAAACYAAAAAAAAAwOD//wAAAAAmAAAAZAAAABYAAABMAAAAAAAAAAAAAAAEAAAAAAAAAAEAAABZWVkKAAAAACgAAAAoAAAAZAAAAGQAAAAAAAAAzMzMAAAAAABQAAAAUAAAAGQAAABkAAAAAAAAABcAAAAUAAAAAAAAAAAAAAD/fwAA/38AAAAAAAAJAAAABAAAAF8AYAAeAAAAaAAAAAAAAAAAAAAAAAAAAAAAAAAAAAAAECcAABAnAAAAAAAAAAAAAAAAAAAAAAAAAAAAAAAAAAAAAAAAAAAAABQAAAAAAAAAwMD/AAAAAABkAAAAMgAAAAAAAABkAAAAAAAAAH9/fwAKAAAAIgAAABgAAAAAAAAAAAAAAAAAAAAAAAAAAAAAAAAAAAAkAAAAJAAAAAAAAAAHAAAAAAAAAAAAAAAAAAAAAAAAAAAAAAAAAAAAf39/ACUAAABYAAAAAAAAAAAAAAAAAAAAAAAAAAAAAAAAAAAAAAAAAAAAAAAAAAAAAAAAAAAAAAA/AAAAAAAAAKCGAQAAAAAAAAAAAAAAAAAMAAAAAQAAAAAAAAAAAAAAAAAAAB8AAABUAAAAAAAABQAAAAEAAAAAAAAAAAAAAAAAAAAAAAAAAAAAAAAAAAAAAAAAAAAAAAJ/f38AAAAAA8zMzADAwP8Af39/AAAAAAAAAAAAAAAAAAAAAAAAAAAAIQAAABgAAAAUAAAAOAQAALgaAAD4JQAACDQAABAAAAAmAAAACAAAAL0/AAAAAAAA"/>
+                <pr:smNativeData xmlns:pr="smNativeData" xmlns="smNativeData" val="SMDATA_15_LkR5ZhMAAAAlAAAAZAAAAA0AAAAAkAAAAJAAAACQAAAAkAAAAAAAAAAAAAAAAAAAAAEAAABQAAAAAAAAAAAA4D8AAAAAAADgPwAAAAAAAOA/AAAAAAAA4D8AAAAAAADgPwAAAAAAAOA/AAAAAAAA4D8AAAAAAADgPwAAAAAAAOA/AAAAAAAA4D8CAAAAjAAAAAAAAAAAAAAAQoX0DP///wgAAAAAAAAAAAAAAAAAAAAAAAAAAAAAAAAAAAAAZAAAAAEAAABAAAAAAAAAAAAAAAAAAAAAAAAAAAAAAAAAAAAAAAAAAAAAAAAAAAAAAAAAAAAAAAAAAAAAAAAAAAAAAAAAAAAAAAAAAAAAAAAAAAAAAAAAAAAAAAAAAAAAFAAAADwAAAAAAAAAAAAAAAAAAAkUAAAAAQAAABQAAAAUAAAAFAAAAAEAAAAAAAAAZAAAAGQAAAAAAAAAZAAAAGQAAAAVAAAAYAAAAAAAAAAAAAAADwAAACADAAAAAAAAAAAAAAEAAACgMgAAVgcAAKr4//8BAAAAf39/AAEAAABkAAAAAAAAABQAAABAHwAAAAAAACYAAAAAAAAAwOD//wAAAAAmAAAAZAAAABYAAABMAAAAAAAAAAAAAAAEAAAAAAAAAAEAAABZWVkKAAAAACgAAAAoAAAAZAAAAGQAAAAAAAAAzMzMAAAAAABQAAAAUAAAAGQAAABkAAAAAAAAABcAAAAUAAAAAAAAAAAAAAD/fwAA/38AAAAAAAAJAAAABAAAAF8AYAAeAAAAaAAAAAAAAAAAAAAAAAAAAAAAAAAAAAAAECcAABAnAAAAAAAAAAAAAAAAAAAAAAAAAAAAAAAAAAAAAAAAAAAAABQAAAAAAAAAwMD/AAAAAABkAAAAMgAAAAAAAABkAAAAAAAAAH9/fwAKAAAAIgAAABgAAAAAAAAAAAAAAAAAAAAAAAAAAAAAAAAAAAAkAAAAJAAAAAAAAAAHAAAAAAAAAAAAAAAAAAAAAAAAAAAAAAAAAAAAf39/ACUAAABYAAAAAAAAAAAAAAAAAAAAAAAAAAAAAAAAAAAAAAAAAAAAAAAAAAAAAAAAAAAAAAA/AAAAAAAAAKCGAQAAAAAAAAAAAAAAAAAMAAAAAQAAAAAAAAAAAAAAAAAAAB8AAABUAAAAAAAABQAAAAEAAAAAAAAAAAAAAAAAAAAAAAAAAAAAAAAAAAAAAAAAAAAAAAJ/f38AAAAAA8zMzADAwP8Af39/AAAAAAAAAAAAAAAAAAAAAAAAAAAAIQAAABgAAAAUAAAAOAQAALgaAAD4JQAACDQAABAAAAAmAAAACAAAAL0/AAAAAAAA"/>
               </a:ext>
             </a:extLst>
           </p:cNvSpPr>
@@ -1559,7 +1435,7 @@
             <a:spLocks noGrp="1" noChangeArrowheads="1"/>
             <a:extLst>
               <a:ext uri="smNativeData">
-                <pr:smNativeData xmlns:pr="smNativeData" xmlns="smNativeData" val="SMDATA_15_EkJ5ZhMAAAAlAAAACwAAAA0AAAAACAcAADgEAAAoIwAAUBkAAAAAAAAAAAAAAAAAAAEAAABQAAAAAAAAAAAA4D8AAAAAAADgPwAAAAAAAOA/AAAAAAAA4D8AAAAAAADgPwAAAAAAAOA/AAAAAAAA4D8AAAAAAADgPwAAAAAAAOA/AAAAAAAA4D8CAAAAjAAAAAAAAAAAAAAAQoX0DP///wgAAAAAAAAAAAAAAAAAAAAAAAAAAAAAAAAAAAAAZAAAAAEAAABAAAAAAAAAAAAAAAAAAAAAAAAAAAAAAAAAAAAAAAAAAAAAAAAAAAAAAAAAAAAAAAAAAAAAAAAAAAAAAAAAAAAAAAAAAAAAAAAAAAAAAAAAAAAAAAAAAAAAFAAAADwAAAABAAAAAAAAAAAAAAAPAAAAAQAAACMAAAAjAAAAIwAAAB4AAAAAAAAASwAAAEsAAAAAAAAASwAAAEsAAAAVAAAAYAAAAAAAAAAAAAAADwAAACADAAAAAAAAAAAAAAEAAACgMgAAVgcAAKr4//8BAAAAf39/AAEAAABkAAAAAAAAABQAAABAHwAAAAAAACYAAAAAAAAAwOD//wAAAAAmAAAAZAAAABYAAABMAAAAAAAAAAAAAAAEAAAAAAAAAAEAAABZWVkKAAAAACgAAAAoAAAAZAAAAGQAAAAAAAAAzMzMAAAAAABQAAAAUAAAAGQAAABkAAAAAAAAABcAAAAUAAAAAAAAAAAAAAD/fwAA/38AAAAAAAAJAAAABAAAAAAAAAAeAAAAaAAAAAAAAAAAAAAAAAAAAAAAAAAAAAAAECcAABAnAAAAAAAAAAAAAAAAAAAAAAAAAAAAAAAAAAAAAAAAAAAAABQAAAAAAAAAwMD/AAAAAABkAAAAMgAAAAAAAABkAAAAAAAAAH9/fwAKAAAAIgAAABgAAAAAAAAAAAAAAAAAAAAAAAAAAAAAAAAAAAAkAAAAJAAAAAAAAAAHAAAAAAAAAAAAAAAAAAAAAAAAAAAAAAAAAAAAf39/ACUAAABYAAAAAAAAAAAAAAAAAAAAAAAAAAAAAAAAAAAAAAAAAAAAAAAAAAAAAAAAAAAAAAA/AAAAAAAAAKCGAQAAAAAAAAAAAAAAAAAMAAAAAQAAAAAAAAAAAAAAAAAAAB8AAABUAAAAAAAABQAAAAEAAAAAAAAAAAAAAAAAAAAAAAAAAAAAAAAAAAAAAAAAAAAAAAB/f38AAAAAA8zMzADAwP8Af39/AAAAAAAAAAAAAAAAAAAAAAAAAAAAIQAAABgAAAAUAAAACAcAADgEAAAoIwAAUBkAABAAAAAmAAAACAAAAAEPAAAAAAAA"/>
+                <pr:smNativeData xmlns:pr="smNativeData" xmlns="smNativeData" val="SMDATA_15_LkR5ZhMAAAAlAAAACwAAAA0AAAAACAcAADgEAAAoIwAAUBkAAAAAAAAAAAAAAAAAAAEAAABQAAAAAAAAAAAA4D8AAAAAAADgPwAAAAAAAOA/AAAAAAAA4D8AAAAAAADgPwAAAAAAAOA/AAAAAAAA4D8AAAAAAADgPwAAAAAAAOA/AAAAAAAA4D8CAAAAjAAAAAAAAAAAAAAAQoX0DP///wgAAAAAAAAAAAAAAAAAAAAAAAAAAAAAAAAAAAAAZAAAAAEAAABAAAAAAAAAAAAAAAAAAAAAAAAAAAAAAAAAAAAAAAAAAAAAAAAAAAAAAAAAAAAAAAAAAAAAAAAAAAAAAAAAAAAAAAAAAAAAAAAAAAAAAAAAAAAAAAAAAAAAFAAAADwAAAABAAAAAAAAAAAAAAAPAAAAAQAAACMAAAAjAAAAIwAAAB4AAAAAAAAASwAAAEsAAAAAAAAASwAAAEsAAAAVAAAAYAAAAAAAAAAAAAAADwAAACADAAAAAAAAAAAAAAEAAACgMgAAVgcAAKr4//8BAAAAf39/AAEAAABkAAAAAAAAABQAAABAHwAAAAAAACYAAAAAAAAAwOD//wAAAAAmAAAAZAAAABYAAABMAAAAAAAAAAAAAAAEAAAAAAAAAAEAAABZWVkKAAAAACgAAAAoAAAAZAAAAGQAAAAAAAAAzMzMAAAAAABQAAAAUAAAAGQAAABkAAAAAAAAABcAAAAUAAAAAAAAAAAAAAD/fwAA/38AAAAAAAAJAAAABAAAAAAAAAAeAAAAaAAAAAAAAAAAAAAAAAAAAAAAAAAAAAAAECcAABAnAAAAAAAAAAAAAAAAAAAAAAAAAAAAAAAAAAAAAAAAAAAAABQAAAAAAAAAwMD/AAAAAABkAAAAMgAAAAAAAABkAAAAAAAAAH9/fwAKAAAAIgAAABgAAAAAAAAAAAAAAAAAAAAAAAAAAAAAAAAAAAAkAAAAJAAAAAAAAAAHAAAAAAAAAAAAAAAAAAAAAAAAAAAAAAAAAAAAf39/ACUAAABYAAAAAAAAAAAAAAAAAAAAAAAAAAAAAAAAAAAAAAAAAAAAAAAAAAAAAAAAAAAAAAA/AAAAAAAAAKCGAQAAAAAAAAAAAAAAAAAMAAAAAQAAAAAAAAAAAAAAAAAAAB8AAABUAAAAAAAABQAAAAEAAAAAAAAAAAAAAAAAAAAAAAAAAAAAAAAAAAAAAAAAAAAAAAB/f38AAAAAA8zMzADAwP8Af39/AAAAAAAAAAAAAAAAAAAAAAAAAAAAIQAAABgAAAAUAAAACAcAADgEAAAoIwAAUBkAABAAAAAmAAAACAAAAAEPAAAAAAAA"/>
               </a:ext>
             </a:extLst>
           </p:cNvSpPr>
@@ -1605,7 +1481,7 @@
             <a:spLocks noGrp="1" noChangeArrowheads="1"/>
             <a:extLst>
               <a:ext uri="smNativeData">
-                <pr:smNativeData xmlns:pr="smNativeData" xmlns="smNativeData" val="SMDATA_15_EkJ5ZhMAAAAlAAAAZAAAAA0AAAAAkAAAAJAAAACQAAAAkAAAAAAAAAAAAAAAAAAAAAEAAABQAAAAAAAAAAAA4D8AAAAAAADgPwAAAAAAAOA/AAAAAAAA4D8AAAAAAADgPwAAAAAAAOA/AAAAAAAA4D8AAAAAAADgPwAAAAAAAOA/AAAAAAAA4D8CAAAAjAAAAAAAAAAAAAAAQoX0DP///wgAAAAAAAAAAAAAAAAAAAAAAAAAAAAAAAAAAAAAZAAAAAEAAABAAAAAAAAAAAAAAAAAAAAAAAAAAAAAAAAAAAAAAAAAAAAAAAAAAAAAAAAAAAAAAAAAAAAAAAAAAAAAAAAAAAAAAAAAAAAAAAAAAAAAAAAAAAAAAAAAAAAAFAAAADwAAAAAAAAAAAAAAAAAAAkUAAAAAQAAABQAAAAUAAAAFAAAAAEAAAAAAAAAZAAAAGQAAAAAAAAAZAAAAGQAAAAVAAAAYAAAAAAAAAAAAAAADwAAACADAAAAAAAAAAAAAAEAAACgMgAAVgcAAKr4//8BAAAAf39/AAEAAABkAAAAAAAAABQAAABAHwAAAAAAACYAAAAAAAAAwOD//wAAAAAmAAAAZAAAABYAAABMAAAAAAAAAAAAAAAEAAAAAAAAAAEAAABZWVkKAAAAACgAAAAoAAAAZAAAAGQAAAAAAAAAzMzMAAAAAABQAAAAUAAAAGQAAABkAAAAAAAAABcAAAAUAAAAAAAAAAAAAAD/fwAA/38AAAAAAAAJAAAABAAAADFRIqYeAAAAaAAAAAAAAAAAAAAAAAAAAAAAAAAAAAAAECcAABAnAAAAAAAAAAAAAAAAAAAAAAAAAAAAAAAAAAAAAAAAAAAAABQAAAAAAAAAwMD/AAAAAABkAAAAMgAAAAAAAABkAAAAAAAAAH9/fwAKAAAAIgAAABgAAAAAAAAAAAAAAAAAAAAAAAAAAAAAAAAAAAAkAAAAJAAAAAAAAAAHAAAAAAAAAAAAAAAAAAAAAAAAAAAAAAAAAAAAf39/ACUAAABYAAAAAAAAAAAAAAAAAAAAAAAAAAAAAAAAAAAAAAAAAAAAAAAAAAAAAAAAAAAAAAA/AAAAAAAAAKCGAQAAAAAAAAAAAAAAAAAMAAAAAQAAAAAAAAAAAAAAAAAAAB8AAABUAAAAAAAABQAAAAEAAAAAAAAAAAAAAAAAAAAAAAAAAAAAAAAAAAAAAAAAAAAAAAJ/f38AAAAAA8zMzADAwP8Af39/AAAAAAAAAAAAAAAAAAAAAAAAAAAAIQAAABgAAAAUAAAAOAQAALgaAAD4JQAACDQAABAAAAAmAAAACAAAAL0/AAAAAAAA"/>
+                <pr:smNativeData xmlns:pr="smNativeData" xmlns="smNativeData" val="SMDATA_15_LkR5ZhMAAAAlAAAAZAAAAA0AAAAAkAAAAJAAAACQAAAAkAAAAAAAAAAAAAAAAAAAAAEAAABQAAAAAAAAAAAA4D8AAAAAAADgPwAAAAAAAOA/AAAAAAAA4D8AAAAAAADgPwAAAAAAAOA/AAAAAAAA4D8AAAAAAADgPwAAAAAAAOA/AAAAAAAA4D8CAAAAjAAAAAAAAAAAAAAAQoX0DP///wgAAAAAAAAAAAAAAAAAAAAAAAAAAAAAAAAAAAAAZAAAAAEAAABAAAAAAAAAAAAAAAAAAAAAAAAAAAAAAAAAAAAAAAAAAAAAAAAAAAAAAAAAAAAAAAAAAAAAAAAAAAAAAAAAAAAAAAAAAAAAAAAAAAAAAAAAAAAAAAAAAAAAFAAAADwAAAAAAAAAAAAAAAAAAAkUAAAAAQAAABQAAAAUAAAAFAAAAAEAAAAAAAAAZAAAAGQAAAAAAAAAZAAAAGQAAAAVAAAAYAAAAAAAAAAAAAAADwAAACADAAAAAAAAAAAAAAEAAACgMgAAVgcAAKr4//8BAAAAf39/AAEAAABkAAAAAAAAABQAAABAHwAAAAAAACYAAAAAAAAAwOD//wAAAAAmAAAAZAAAABYAAABMAAAAAAAAAAAAAAAEAAAAAAAAAAEAAABZWVkKAAAAACgAAAAoAAAAZAAAAGQAAAAAAAAAzMzMAAAAAABQAAAAUAAAAGQAAABkAAAAAAAAABcAAAAUAAAAAAAAAAAAAAD/fwAA/38AAAAAAAAJAAAABAAAADFRIqYeAAAAaAAAAAAAAAAAAAAAAAAAAAAAAAAAAAAAECcAABAnAAAAAAAAAAAAAAAAAAAAAAAAAAAAAAAAAAAAAAAAAAAAABQAAAAAAAAAwMD/AAAAAABkAAAAMgAAAAAAAABkAAAAAAAAAH9/fwAKAAAAIgAAABgAAAAAAAAAAAAAAAAAAAAAAAAAAAAAAAAAAAAkAAAAJAAAAAAAAAAHAAAAAAAAAAAAAAAAAAAAAAAAAAAAAAAAAAAAf39/ACUAAABYAAAAAAAAAAAAAAAAAAAAAAAAAAAAAAAAAAAAAAAAAAAAAAAAAAAAAAAAAAAAAAA/AAAAAAAAAKCGAQAAAAAAAAAAAAAAAAAMAAAAAQAAAAAAAAAAAAAAAAAAAB8AAABUAAAAAAAABQAAAAEAAAAAAAAAAAAAAAAAAAAAAAAAAAAAAAAAAAAAAAAAAAAAAAJ/f38AAAAAA8zMzADAwP8Af39/AAAAAAAAAAAAAAAAAAAAAAAAAAAAIQAAABgAAAAUAAAAOAQAALgaAAD4JQAACDQAABAAAAAmAAAACAAAAL0/AAAAAAAA"/>
               </a:ext>
             </a:extLst>
           </p:cNvSpPr>
@@ -1682,7 +1558,7 @@
             <a:spLocks noGrp="1" noChangeArrowheads="1"/>
             <a:extLst>
               <a:ext uri="smNativeData">
-                <pr:smNativeData xmlns:pr="smNativeData" xmlns="smNativeData" val="SMDATA_15_EkJ5ZhMAAAAlAAAACwAAAA0AAAAACAcAADgEAAAoIwAAUBkAAAAAAAAAAAAAAAAAAAEAAABQAAAAAAAAAAAA4D8AAAAAAADgPwAAAAAAAOA/AAAAAAAA4D8AAAAAAADgPwAAAAAAAOA/AAAAAAAA4D8AAAAAAADgPwAAAAAAAOA/AAAAAAAA4D8CAAAAjAAAAAAAAAAAAAAAQoX0DP///wgAAAAAAAAAAAAAAAAAAAAAAAAAAAAAAAAAAAAAZAAAAAEAAABAAAAAAAAAAAAAAAAAAAAAAAAAAAAAAAAAAAAAAAAAAAAAAAAAAAAAAAAAAAAAAAAAAAAAAAAAAAAAAAAAAAAAAAAAAAAAAAAAAAAAAAAAAAAAAAAAAAAAFAAAADwAAAABAAAAAAAAAAAAAAAPAAAAAQAAACMAAAAjAAAAIwAAAB4AAAAAAAAASwAAAEsAAAAAAAAASwAAAEsAAAAVAAAAYAAAAAAAAAAAAAAADwAAACADAAAAAAAAAAAAAAEAAACgMgAAVgcAAKr4//8BAAAAf39/AAEAAABkAAAAAAAAABQAAABAHwAAAAAAACYAAAAAAAAAwOD//wAAAAAmAAAAZAAAABYAAABMAAAAAAAAAAAAAAAEAAAAAAAAAAEAAABZWVkKAAAAACgAAAAoAAAAZAAAAGQAAAAAAAAAzMzMAAAAAABQAAAAUAAAAGQAAABkAAAAAAAAABcAAAAUAAAAAAAAAAAAAAD/fwAA/38AAAAAAAAJAAAABAAAAAAAAAAeAAAAaAAAAAAAAAAAAAAAAAAAAAAAAAAAAAAAECcAABAnAAAAAAAAAAAAAAAAAAAAAAAAAAAAAAAAAAAAAAAAAAAAABQAAAAAAAAAwMD/AAAAAABkAAAAMgAAAAAAAABkAAAAAAAAAH9/fwAKAAAAIgAAABgAAAAAAAAAAAAAAAAAAAAAAAAAAAAAAAAAAAAkAAAAJAAAAAAAAAAHAAAAAAAAAAAAAAAAAAAAAAAAAAAAAAAAAAAAf39/ACUAAABYAAAAAAAAAAAAAAAAAAAAAAAAAAAAAAAAAAAAAAAAAAAAAAAAAAAAAAAAAAAAAAA/AAAAAAAAAKCGAQAAAAAAAAAAAAAAAAAMAAAAAQAAAAAAAAAAAAAAAAAAAB8AAABUAAAAAAAABQAAAAEAAAAAAAAAAAAAAAAAAAAAAAAAAAAAAAAAAAAAAAAAAAAAAAB/f38AAAAAA8zMzADAwP8Af39/AAAAAAAAAAAAAAAAAAAAAAAAAAAAIQAAABgAAAAUAAAACAcAADgEAAAoIwAAUBkAABAAAAAmAAAACAAAAAEPAAAAAAAA"/>
+                <pr:smNativeData xmlns:pr="smNativeData" xmlns="smNativeData" val="SMDATA_15_LkR5ZhMAAAAlAAAACwAAAA0AAAAACAcAADgEAAAoIwAAUBkAAAAAAAAAAAAAAAAAAAEAAABQAAAAAAAAAAAA4D8AAAAAAADgPwAAAAAAAOA/AAAAAAAA4D8AAAAAAADgPwAAAAAAAOA/AAAAAAAA4D8AAAAAAADgPwAAAAAAAOA/AAAAAAAA4D8CAAAAjAAAAAAAAAAAAAAAQoX0DP///wgAAAAAAAAAAAAAAAAAAAAAAAAAAAAAAAAAAAAAZAAAAAEAAABAAAAAAAAAAAAAAAAAAAAAAAAAAAAAAAAAAAAAAAAAAAAAAAAAAAAAAAAAAAAAAAAAAAAAAAAAAAAAAAAAAAAAAAAAAAAAAAAAAAAAAAAAAAAAAAAAAAAAFAAAADwAAAABAAAAAAAAAAAAAAAPAAAAAQAAACMAAAAjAAAAIwAAAB4AAAAAAAAASwAAAEsAAAAAAAAASwAAAEsAAAAVAAAAYAAAAAAAAAAAAAAADwAAACADAAAAAAAAAAAAAAEAAACgMgAAVgcAAKr4//8BAAAAf39/AAEAAABkAAAAAAAAABQAAABAHwAAAAAAACYAAAAAAAAAwOD//wAAAAAmAAAAZAAAABYAAABMAAAAAAAAAAAAAAAEAAAAAAAAAAEAAABZWVkKAAAAACgAAAAoAAAAZAAAAGQAAAAAAAAAzMzMAAAAAABQAAAAUAAAAGQAAABkAAAAAAAAABcAAAAUAAAAAAAAAAAAAAD/fwAA/38AAAAAAAAJAAAABAAAAAAAAAAeAAAAaAAAAAAAAAAAAAAAAAAAAAAAAAAAAAAAECcAABAnAAAAAAAAAAAAAAAAAAAAAAAAAAAAAAAAAAAAAAAAAAAAABQAAAAAAAAAwMD/AAAAAABkAAAAMgAAAAAAAABkAAAAAAAAAH9/fwAKAAAAIgAAABgAAAAAAAAAAAAAAAAAAAAAAAAAAAAAAAAAAAAkAAAAJAAAAAAAAAAHAAAAAAAAAAAAAAAAAAAAAAAAAAAAAAAAAAAAf39/ACUAAABYAAAAAAAAAAAAAAAAAAAAAAAAAAAAAAAAAAAAAAAAAAAAAAAAAAAAAAAAAAAAAAA/AAAAAAAAAKCGAQAAAAAAAAAAAAAAAAAMAAAAAQAAAAAAAAAAAAAAAAAAAB8AAABUAAAAAAAABQAAAAEAAAAAAAAAAAAAAAAAAAAAAAAAAAAAAAAAAAAAAAAAAAAAAAB/f38AAAAAA8zMzADAwP8Af39/AAAAAAAAAAAAAAAAAAAAAAAAAAAAIQAAABgAAAAUAAAACAcAADgEAAAoIwAAUBkAABAAAAAmAAAACAAAAAEPAAAAAAAA"/>
               </a:ext>
             </a:extLst>
           </p:cNvSpPr>
@@ -1728,7 +1604,7 @@
             <a:spLocks noGrp="1" noChangeArrowheads="1"/>
             <a:extLst>
               <a:ext uri="smNativeData">
-                <pr:smNativeData xmlns:pr="smNativeData" xmlns="smNativeData" val="SMDATA_15_EkJ5ZhMAAAAlAAAAZAAAAA0AAAAAkAAAAJAAAACQAAAAkAAAAAAAAAAAAAAAAAAAAAEAAABQAAAAAAAAAAAA4D8AAAAAAADgPwAAAAAAAOA/AAAAAAAA4D8AAAAAAADgPwAAAAAAAOA/AAAAAAAA4D8AAAAAAADgPwAAAAAAAOA/AAAAAAAA4D8CAAAAjAAAAAAAAAAAAAAAQoX0DP///wgAAAAAAAAAAAAAAAAAAAAAAAAAAAAAAAAAAAAAZAAAAAEAAABAAAAAAAAAAAAAAAAAAAAAAAAAAAAAAAAAAAAAAAAAAAAAAAAAAAAAAAAAAAAAAAAAAAAAAAAAAAAAAAAAAAAAAAAAAAAAAAAAAAAAAAAAAAAAAAAAAAAAFAAAADwAAAAAAAAAAAAAAAAAAAkUAAAAAQAAABQAAAAUAAAAFAAAAAEAAAAAAAAAZAAAAGQAAAAAAAAAZAAAAGQAAAAVAAAAYAAAAAAAAAAAAAAADwAAACADAAAAAAAAAAAAAAEAAACgMgAAVgcAAKr4//8BAAAAf39/AAEAAABkAAAAAAAAABQAAABAHwAAAAAAACYAAAAAAAAAwOD//wAAAAAmAAAAZAAAABYAAABMAAAAAAAAAAAAAAAEAAAAAAAAAAEAAABZWVkKAAAAACgAAAAoAAAAZAAAAGQAAAAAAAAAzMzMAAAAAABQAAAAUAAAAGQAAABkAAAAAAAAABcAAAAUAAAAAAAAAAAAAAD/fwAA/38AAAAAAAAJAAAABAAAAKMkqfweAAAAaAAAAAAAAAAAAAAAAAAAAAAAAAAAAAAAECcAABAnAAAAAAAAAAAAAAAAAAAAAAAAAAAAAAAAAAAAAAAAAAAAABQAAAAAAAAAwMD/AAAAAABkAAAAMgAAAAAAAABkAAAAAAAAAH9/fwAKAAAAIgAAABgAAAAAAAAAAAAAAAAAAAAAAAAAAAAAAAAAAAAkAAAAJAAAAAAAAAAHAAAAAAAAAAAAAAAAAAAAAAAAAAAAAAAAAAAAf39/ACUAAABYAAAAAAAAAAAAAAAAAAAAAAAAAAAAAAAAAAAAAAAAAAAAAAAAAAAAAAAAAAAAAAA/AAAAAAAAAKCGAQAAAAAAAAAAAAAAAAAMAAAAAQAAAAAAAAAAAAAAAAAAAB8AAABUAAAAAAAABQAAAAEAAAAAAAAAAAAAAAAAAAAAAAAAAAAAAAAAAAAAAAAAAAAAAAJ/f38AAAAAA8zMzADAwP8Af39/AAAAAAAAAAAAAAAAAAAAAAAAAAAAIQAAABgAAAAUAAAAOAQAALgaAAD4JQAACDQAABAAAAAmAAAACAAAAL0/AAAAAAAA"/>
+                <pr:smNativeData xmlns:pr="smNativeData" xmlns="smNativeData" val="SMDATA_15_LkR5ZhMAAAAlAAAAZAAAAA0AAAAAkAAAAJAAAACQAAAAkAAAAAAAAAAAAAAAAAAAAAEAAABQAAAAAAAAAAAA4D8AAAAAAADgPwAAAAAAAOA/AAAAAAAA4D8AAAAAAADgPwAAAAAAAOA/AAAAAAAA4D8AAAAAAADgPwAAAAAAAOA/AAAAAAAA4D8CAAAAjAAAAAAAAAAAAAAAQoX0DP///wgAAAAAAAAAAAAAAAAAAAAAAAAAAAAAAAAAAAAAZAAAAAEAAABAAAAAAAAAAAAAAAAAAAAAAAAAAAAAAAAAAAAAAAAAAAAAAAAAAAAAAAAAAAAAAAAAAAAAAAAAAAAAAAAAAAAAAAAAAAAAAAAAAAAAAAAAAAAAAAAAAAAAFAAAADwAAAAAAAAAAAAAAAAAAAkUAAAAAQAAABQAAAAUAAAAFAAAAAEAAAAAAAAAZAAAAGQAAAAAAAAAZAAAAGQAAAAVAAAAYAAAAAAAAAAAAAAADwAAACADAAAAAAAAAAAAAAEAAACgMgAAVgcAAKr4//8BAAAAf39/AAEAAABkAAAAAAAAABQAAABAHwAAAAAAACYAAAAAAAAAwOD//wAAAAAmAAAAZAAAABYAAABMAAAAAAAAAAAAAAAEAAAAAAAAAAEAAABZWVkKAAAAACgAAAAoAAAAZAAAAGQAAAAAAAAAzMzMAAAAAABQAAAAUAAAAGQAAABkAAAAAAAAABcAAAAUAAAAAAAAAAAAAAD/fwAA/38AAAAAAAAJAAAABAAAAKMkqfweAAAAaAAAAAAAAAAAAAAAAAAAAAAAAAAAAAAAECcAABAnAAAAAAAAAAAAAAAAAAAAAAAAAAAAAAAAAAAAAAAAAAAAABQAAAAAAAAAwMD/AAAAAABkAAAAMgAAAAAAAABkAAAAAAAAAH9/fwAKAAAAIgAAABgAAAAAAAAAAAAAAAAAAAAAAAAAAAAAAAAAAAAkAAAAJAAAAAAAAAAHAAAAAAAAAAAAAAAAAAAAAAAAAAAAAAAAAAAAf39/ACUAAABYAAAAAAAAAAAAAAAAAAAAAAAAAAAAAAAAAAAAAAAAAAAAAAAAAAAAAAAAAAAAAAA/AAAAAAAAAKCGAQAAAAAAAAAAAAAAAAAMAAAAAQAAAAAAAAAAAAAAAAAAAB8AAABUAAAAAAAABQAAAAEAAAAAAAAAAAAAAAAAAAAAAAAAAAAAAAAAAAAAAAAAAAAAAAJ/f38AAAAAA8zMzADAwP8Af39/AAAAAAAAAAAAAAAAAAAAAAAAAAAAIQAAABgAAAAUAAAAOAQAALgaAAD4JQAACDQAABAAAAAmAAAACAAAAL0/AAAAAAAA"/>
               </a:ext>
             </a:extLst>
           </p:cNvSpPr>
@@ -1805,7 +1681,7 @@
             <a:spLocks noGrp="1" noChangeArrowheads="1"/>
             <a:extLst>
               <a:ext uri="smNativeData">
-                <pr:smNativeData xmlns:pr="smNativeData" xmlns="smNativeData" val="SMDATA_15_EkJ5ZhMAAAAlAAAACwAAAA0AAAAACAcAADgEAAAoIwAAUBkAAAAAAAAAAAAAAAAAAAEAAABQAAAAAAAAAAAA4D8AAAAAAADgPwAAAAAAAOA/AAAAAAAA4D8AAAAAAADgPwAAAAAAAOA/AAAAAAAA4D8AAAAAAADgPwAAAAAAAOA/AAAAAAAA4D8CAAAAjAAAAAAAAAAAAAAAQoX0DP///wgAAAAAAAAAAAAAAAAAAAAAAAAAAAAAAAAAAAAAZAAAAAEAAABAAAAAAAAAAAAAAAAAAAAAAAAAAAAAAAAAAAAAAAAAAAAAAAAAAAAAAAAAAAAAAAAAAAAAAAAAAAAAAAAAAAAAAAAAAAAAAAAAAAAAAAAAAAAAAAAAAAAAFAAAADwAAAABAAAAAAAAAAAAAAAPAAAAAQAAACMAAAAjAAAAIwAAAB4AAAAAAAAASwAAAEsAAAAAAAAASwAAAEsAAAAVAAAAYAAAAAAAAAAAAAAADwAAACADAAAAAAAAAAAAAAEAAACgMgAAVgcAAKr4//8BAAAAf39/AAEAAABkAAAAAAAAABQAAABAHwAAAAAAACYAAAAAAAAAwOD//wAAAAAmAAAAZAAAABYAAABMAAAAAAAAAAAAAAAEAAAAAAAAAAEAAABZWVkKAAAAACgAAAAoAAAAZAAAAGQAAAAAAAAAzMzMAAAAAABQAAAAUAAAAGQAAABkAAAAAAAAABcAAAAUAAAAAAAAAAAAAAD/fwAA/38AAAAAAAAJAAAABAAAAAAAAAAeAAAAaAAAAAAAAAAAAAAAAAAAAAAAAAAAAAAAECcAABAnAAAAAAAAAAAAAAAAAAAAAAAAAAAAAAAAAAAAAAAAAAAAABQAAAAAAAAAwMD/AAAAAABkAAAAMgAAAAAAAABkAAAAAAAAAH9/fwAKAAAAIgAAABgAAAAAAAAAAAAAAAAAAAAAAAAAAAAAAAAAAAAkAAAAJAAAAAAAAAAHAAAAAAAAAAAAAAAAAAAAAAAAAAAAAAAAAAAAf39/ACUAAABYAAAAAAAAAAAAAAAAAAAAAAAAAAAAAAAAAAAAAAAAAAAAAAAAAAAAAAAAAAAAAAA/AAAAAAAAAKCGAQAAAAAAAAAAAAAAAAAMAAAAAQAAAAAAAAAAAAAAAAAAAB8AAABUAAAAAAAABQAAAAEAAAAAAAAAAAAAAAAAAAAAAAAAAAAAAAAAAAAAAAAAAAAAAAB/f38AAAAAA8zMzADAwP8Af39/AAAAAAAAAAAAAAAAAAAAAAAAAAAAIQAAABgAAAAUAAAACAcAADgEAAAoIwAAUBkAABAAAAAmAAAACAAAAAEPAAAAAAAA"/>
+                <pr:smNativeData xmlns:pr="smNativeData" xmlns="smNativeData" val="SMDATA_15_LkR5ZhMAAAAlAAAACwAAAA0AAAAACAcAADgEAAAoIwAAUBkAAAAAAAAAAAAAAAAAAAEAAABQAAAAAAAAAAAA4D8AAAAAAADgPwAAAAAAAOA/AAAAAAAA4D8AAAAAAADgPwAAAAAAAOA/AAAAAAAA4D8AAAAAAADgPwAAAAAAAOA/AAAAAAAA4D8CAAAAjAAAAAAAAAAAAAAAQoX0DP///wgAAAAAAAAAAAAAAAAAAAAAAAAAAAAAAAAAAAAAZAAAAAEAAABAAAAAAAAAAAAAAAAAAAAAAAAAAAAAAAAAAAAAAAAAAAAAAAAAAAAAAAAAAAAAAAAAAAAAAAAAAAAAAAAAAAAAAAAAAAAAAAAAAAAAAAAAAAAAAAAAAAAAFAAAADwAAAABAAAAAAAAAAAAAAAPAAAAAQAAACMAAAAjAAAAIwAAAB4AAAAAAAAASwAAAEsAAAAAAAAASwAAAEsAAAAVAAAAYAAAAAAAAAAAAAAADwAAACADAAAAAAAAAAAAAAEAAACgMgAAVgcAAKr4//8BAAAAf39/AAEAAABkAAAAAAAAABQAAABAHwAAAAAAACYAAAAAAAAAwOD//wAAAAAmAAAAZAAAABYAAABMAAAAAAAAAAAAAAAEAAAAAAAAAAEAAABZWVkKAAAAACgAAAAoAAAAZAAAAGQAAAAAAAAAzMzMAAAAAABQAAAAUAAAAGQAAABkAAAAAAAAABcAAAAUAAAAAAAAAAAAAAD/fwAA/38AAAAAAAAJAAAABAAAAAAAAAAeAAAAaAAAAAAAAAAAAAAAAAAAAAAAAAAAAAAAECcAABAnAAAAAAAAAAAAAAAAAAAAAAAAAAAAAAAAAAAAAAAAAAAAABQAAAAAAAAAwMD/AAAAAABkAAAAMgAAAAAAAABkAAAAAAAAAH9/fwAKAAAAIgAAABgAAAAAAAAAAAAAAAAAAAAAAAAAAAAAAAAAAAAkAAAAJAAAAAAAAAAHAAAAAAAAAAAAAAAAAAAAAAAAAAAAAAAAAAAAf39/ACUAAABYAAAAAAAAAAAAAAAAAAAAAAAAAAAAAAAAAAAAAAAAAAAAAAAAAAAAAAAAAAAAAAA/AAAAAAAAAKCGAQAAAAAAAAAAAAAAAAAMAAAAAQAAAAAAAAAAAAAAAAAAAB8AAABUAAAAAAAABQAAAAEAAAAAAAAAAAAAAAAAAAAAAAAAAAAAAAAAAAAAAAAAAAAAAAB/f38AAAAAA8zMzADAwP8Af39/AAAAAAAAAAAAAAAAAAAAAAAAAAAAIQAAABgAAAAUAAAACAcAADgEAAAoIwAAUBkAABAAAAAmAAAACAAAAAEPAAAAAAAA"/>
               </a:ext>
             </a:extLst>
           </p:cNvSpPr>
@@ -1851,7 +1727,7 @@
             <a:spLocks noGrp="1" noChangeArrowheads="1"/>
             <a:extLst>
               <a:ext uri="smNativeData">
-                <pr:smNativeData xmlns:pr="smNativeData" xmlns="smNativeData" val="SMDATA_15_EkJ5ZhMAAAAlAAAAZAAAAA0AAAAAkAAAAJAAAACQAAAAkAAAAAAAAAAAAAAAAAAAAAEAAABQAAAAAAAAAAAA4D8AAAAAAADgPwAAAAAAAOA/AAAAAAAA4D8AAAAAAADgPwAAAAAAAOA/AAAAAAAA4D8AAAAAAADgPwAAAAAAAOA/AAAAAAAA4D8CAAAAjAAAAAAAAAAAAAAAQoX0DP///wgAAAAAAAAAAAAAAAAAAAAAAAAAAAAAAAAAAAAAZAAAAAEAAABAAAAAAAAAAAAAAAAAAAAAAAAAAAAAAAAAAAAAAAAAAAAAAAAAAAAAAAAAAAAAAAAAAAAAAAAAAAAAAAAAAAAAAAAAAAAAAAAAAAAAAAAAAAAAAAAAAAAAFAAAADwAAAAAAAAAAAAAAAAAAAkUAAAAAQAAABQAAAAUAAAAFAAAAAEAAAAAAAAAZAAAAGQAAAAAAAAAZAAAAGQAAAAVAAAAYAAAAAAAAAAAAAAADwAAACADAAAAAAAAAAAAAAEAAACgMgAAVgcAAKr4//8BAAAAf39/AAEAAABkAAAAAAAAABQAAABAHwAAAAAAACYAAAAAAAAAwOD//wAAAAAmAAAAZAAAABYAAABMAAAAAAAAAAAAAAAEAAAAAAAAAAEAAABZWVkKAAAAACgAAAAoAAAAZAAAAGQAAAAAAAAAzMzMAAAAAABQAAAAUAAAAGQAAABkAAAAAAAAABcAAAAUAAAAAAAAAAAAAAD/fwAA/38AAAAAAAAJAAAABAAAAF8AYAAeAAAAaAAAAAAAAAAAAAAAAAAAAAAAAAAAAAAAECcAABAnAAAAAAAAAAAAAAAAAAAAAAAAAAAAAAAAAAAAAAAAAAAAABQAAAAAAAAAwMD/AAAAAABkAAAAMgAAAAAAAABkAAAAAAAAAH9/fwAKAAAAIgAAABgAAAAAAAAAAAAAAAAAAAAAAAAAAAAAAAAAAAAkAAAAJAAAAAAAAAAHAAAAAAAAAAAAAAAAAAAAAAAAAAAAAAAAAAAAf39/ACUAAABYAAAAAAAAAAAAAAAAAAAAAAAAAAAAAAAAAAAAAAAAAAAAAAAAAAAAAAAAAAAAAAA/AAAAAAAAAKCGAQAAAAAAAAAAAAAAAAAMAAAAAQAAAAAAAAAAAAAAAAAAAB8AAABUAAAAAAAABQAAAAEAAAAAAAAAAAAAAAAAAAAAAAAAAAAAAAAAAAAAAAAAAAAAAAJ/f38AAAAAA8zMzADAwP8Af39/AAAAAAAAAAAAAAAAAAAAAAAAAAAAIQAAABgAAAAUAAAAOAQAALgaAAD4JQAACDQAABAAAAAmAAAACAAAAL0/AAAAAAAA"/>
+                <pr:smNativeData xmlns:pr="smNativeData" xmlns="smNativeData" val="SMDATA_15_LkR5ZhMAAAAlAAAAZAAAAA0AAAAAkAAAAJAAAACQAAAAkAAAAAAAAAAAAAAAAAAAAAEAAABQAAAAAAAAAAAA4D8AAAAAAADgPwAAAAAAAOA/AAAAAAAA4D8AAAAAAADgPwAAAAAAAOA/AAAAAAAA4D8AAAAAAADgPwAAAAAAAOA/AAAAAAAA4D8CAAAAjAAAAAAAAAAAAAAAQoX0DP///wgAAAAAAAAAAAAAAAAAAAAAAAAAAAAAAAAAAAAAZAAAAAEAAABAAAAAAAAAAAAAAAAAAAAAAAAAAAAAAAAAAAAAAAAAAAAAAAAAAAAAAAAAAAAAAAAAAAAAAAAAAAAAAAAAAAAAAAAAAAAAAAAAAAAAAAAAAAAAAAAAAAAAFAAAADwAAAAAAAAAAAAAAAAAAAkUAAAAAQAAABQAAAAUAAAAFAAAAAEAAAAAAAAAZAAAAGQAAAAAAAAAZAAAAGQAAAAVAAAAYAAAAAAAAAAAAAAADwAAACADAAAAAAAAAAAAAAEAAACgMgAAVgcAAKr4//8BAAAAf39/AAEAAABkAAAAAAAAABQAAABAHwAAAAAAACYAAAAAAAAAwOD//wAAAAAmAAAAZAAAABYAAABMAAAAAAAAAAAAAAAEAAAAAAAAAAEAAABZWVkKAAAAACgAAAAoAAAAZAAAAGQAAAAAAAAAzMzMAAAAAABQAAAAUAAAAGQAAABkAAAAAAAAABcAAAAUAAAAAAAAAAAAAAD/fwAA/38AAAAAAAAJAAAABAAAAF8AYAAeAAAAaAAAAAAAAAAAAAAAAAAAAAAAAAAAAAAAECcAABAnAAAAAAAAAAAAAAAAAAAAAAAAAAAAAAAAAAAAAAAAAAAAABQAAAAAAAAAwMD/AAAAAABkAAAAMgAAAAAAAABkAAAAAAAAAH9/fwAKAAAAIgAAABgAAAAAAAAAAAAAAAAAAAAAAAAAAAAAAAAAAAAkAAAAJAAAAAAAAAAHAAAAAAAAAAAAAAAAAAAAAAAAAAAAAAAAAAAAf39/ACUAAABYAAAAAAAAAAAAAAAAAAAAAAAAAAAAAAAAAAAAAAAAAAAAAAAAAAAAAAAAAAAAAAA/AAAAAAAAAKCGAQAAAAAAAAAAAAAAAAAMAAAAAQAAAAAAAAAAAAAAAAAAAB8AAABUAAAAAAAABQAAAAEAAAAAAAAAAAAAAAAAAAAAAAAAAAAAAAAAAAAAAAAAAAAAAAJ/f38AAAAAA8zMzADAwP8Af39/AAAAAAAAAAAAAAAAAAAAAAAAAAAAIQAAABgAAAAUAAAAOAQAALgaAAD4JQAACDQAABAAAAAmAAAACAAAAL0/AAAAAAAA"/>
               </a:ext>
             </a:extLst>
           </p:cNvSpPr>
@@ -1928,7 +1804,7 @@
             <a:spLocks noGrp="1" noChangeArrowheads="1"/>
             <a:extLst>
               <a:ext uri="smNativeData">
-                <pr:smNativeData xmlns:pr="smNativeData" xmlns="smNativeData" val="SMDATA_15_EkJ5ZhMAAAAlAAAACwAAAA0AAAAACAcAADgEAAAoIwAAUBkAAAAAAAAAAAAAAAAAAAEAAABQAAAAAAAAAAAA4D8AAAAAAADgPwAAAAAAAOA/AAAAAAAA4D8AAAAAAADgPwAAAAAAAOA/AAAAAAAA4D8AAAAAAADgPwAAAAAAAOA/AAAAAAAA4D8CAAAAjAAAAAAAAAAAAAAAQoX0DP///wgAAAAAAAAAAAAAAAAAAAAAAAAAAAAAAAAAAAAAZAAAAAEAAABAAAAAAAAAAAAAAAAAAAAAAAAAAAAAAAAAAAAAAAAAAAAAAAAAAAAAAAAAAAAAAAAAAAAAAAAAAAAAAAAAAAAAAAAAAAAAAAAAAAAAAAAAAAAAAAAAAAAAFAAAADwAAAABAAAAAAAAAAAAAAAPAAAAAQAAACMAAAAjAAAAIwAAAB4AAAAAAAAASwAAAEsAAAAAAAAASwAAAEsAAAAVAAAAYAAAAAAAAAAAAAAADwAAACADAAAAAAAAAAAAAAEAAACgMgAAVgcAAKr4//8BAAAAf39/AAEAAABkAAAAAAAAABQAAABAHwAAAAAAACYAAAAAAAAAwOD//wAAAAAmAAAAZAAAABYAAABMAAAAAAAAAAAAAAAEAAAAAAAAAAEAAABZWVkKAAAAACgAAAAoAAAAZAAAAGQAAAAAAAAAzMzMAAAAAABQAAAAUAAAAGQAAABkAAAAAAAAABcAAAAUAAAAAAAAAAAAAAD/fwAA/38AAAAAAAAJAAAABAAAAAAAAAAeAAAAaAAAAAAAAAAAAAAAAAAAAAAAAAAAAAAAECcAABAnAAAAAAAAAAAAAAAAAAAAAAAAAAAAAAAAAAAAAAAAAAAAABQAAAAAAAAAwMD/AAAAAABkAAAAMgAAAAAAAABkAAAAAAAAAH9/fwAKAAAAIgAAABgAAAAAAAAAAAAAAAAAAAAAAAAAAAAAAAAAAAAkAAAAJAAAAAAAAAAHAAAAAAAAAAAAAAAAAAAAAAAAAAAAAAAAAAAAf39/ACUAAABYAAAAAAAAAAAAAAAAAAAAAAAAAAAAAAAAAAAAAAAAAAAAAAAAAAAAAAAAAAAAAAA/AAAAAAAAAKCGAQAAAAAAAAAAAAAAAAAMAAAAAQAAAAAAAAAAAAAAAAAAAB8AAABUAAAAAAAABQAAAAEAAAAAAAAAAAAAAAAAAAAAAAAAAAAAAAAAAAAAAAAAAAAAAAB/f38AAAAAA8zMzADAwP8Af39/AAAAAAAAAAAAAAAAAAAAAAAAAAAAIQAAABgAAAAUAAAACAcAADgEAAAoIwAAUBkAABAAAAAmAAAACAAAAAEPAAAAAAAA"/>
+                <pr:smNativeData xmlns:pr="smNativeData" xmlns="smNativeData" val="SMDATA_15_LkR5ZhMAAAAlAAAACwAAAA0AAAAACAcAADgEAAAoIwAAUBkAAAAAAAAAAAAAAAAAAAEAAABQAAAAAAAAAAAA4D8AAAAAAADgPwAAAAAAAOA/AAAAAAAA4D8AAAAAAADgPwAAAAAAAOA/AAAAAAAA4D8AAAAAAADgPwAAAAAAAOA/AAAAAAAA4D8CAAAAjAAAAAAAAAAAAAAAQoX0DP///wgAAAAAAAAAAAAAAAAAAAAAAAAAAAAAAAAAAAAAZAAAAAEAAABAAAAAAAAAAAAAAAAAAAAAAAAAAAAAAAAAAAAAAAAAAAAAAAAAAAAAAAAAAAAAAAAAAAAAAAAAAAAAAAAAAAAAAAAAAAAAAAAAAAAAAAAAAAAAAAAAAAAAFAAAADwAAAABAAAAAAAAAAAAAAAPAAAAAQAAACMAAAAjAAAAIwAAAB4AAAAAAAAASwAAAEsAAAAAAAAASwAAAEsAAAAVAAAAYAAAAAAAAAAAAAAADwAAACADAAAAAAAAAAAAAAEAAACgMgAAVgcAAKr4//8BAAAAf39/AAEAAABkAAAAAAAAABQAAABAHwAAAAAAACYAAAAAAAAAwOD//wAAAAAmAAAAZAAAABYAAABMAAAAAAAAAAAAAAAEAAAAAAAAAAEAAABZWVkKAAAAACgAAAAoAAAAZAAAAGQAAAAAAAAAzMzMAAAAAABQAAAAUAAAAGQAAABkAAAAAAAAABcAAAAUAAAAAAAAAAAAAAD/fwAA/38AAAAAAAAJAAAABAAAAAAAAAAeAAAAaAAAAAAAAAAAAAAAAAAAAAAAAAAAAAAAECcAABAnAAAAAAAAAAAAAAAAAAAAAAAAAAAAAAAAAAAAAAAAAAAAABQAAAAAAAAAwMD/AAAAAABkAAAAMgAAAAAAAABkAAAAAAAAAH9/fwAKAAAAIgAAABgAAAAAAAAAAAAAAAAAAAAAAAAAAAAAAAAAAAAkAAAAJAAAAAAAAAAHAAAAAAAAAAAAAAAAAAAAAAAAAAAAAAAAAAAAf39/ACUAAABYAAAAAAAAAAAAAAAAAAAAAAAAAAAAAAAAAAAAAAAAAAAAAAAAAAAAAAAAAAAAAAA/AAAAAAAAAKCGAQAAAAAAAAAAAAAAAAAMAAAAAQAAAAAAAAAAAAAAAAAAAB8AAABUAAAAAAAABQAAAAEAAAAAAAAAAAAAAAAAAAAAAAAAAAAAAAAAAAAAAAAAAAAAAAB/f38AAAAAA8zMzADAwP8Af39/AAAAAAAAAAAAAAAAAAAAAAAAAAAAIQAAABgAAAAUAAAACAcAADgEAAAoIwAAUBkAABAAAAAmAAAACAAAAAEPAAAAAAAA"/>
               </a:ext>
             </a:extLst>
           </p:cNvSpPr>
@@ -1974,7 +1850,7 @@
             <a:spLocks noGrp="1" noChangeArrowheads="1"/>
             <a:extLst>
               <a:ext uri="smNativeData">
-                <pr:smNativeData xmlns:pr="smNativeData" xmlns="smNativeData" val="SMDATA_15_EkJ5ZhMAAAAlAAAAZAAAAA0AAAAAkAAAAJAAAACQAAAAkAAAAAAAAAAAAAAAAAAAAAEAAABQAAAAAAAAAAAA4D8AAAAAAADgPwAAAAAAAOA/AAAAAAAA4D8AAAAAAADgPwAAAAAAAOA/AAAAAAAA4D8AAAAAAADgPwAAAAAAAOA/AAAAAAAA4D8CAAAAjAAAAAAAAAAAAAAAQoX0DP///wgAAAAAAAAAAAAAAAAAAAAAAAAAAAAAAAAAAAAAZAAAAAEAAABAAAAAAAAAAAAAAAAAAAAAAAAAAAAAAAAAAAAAAAAAAAAAAAAAAAAAAAAAAAAAAAAAAAAAAAAAAAAAAAAAAAAAAAAAAAAAAAAAAAAAAAAAAAAAAAAAAAAAFAAAADwAAAAAAAAAAAAAAAAAAAkUAAAAAQAAABQAAAAUAAAAFAAAAAEAAAAAAAAAZAAAAGQAAAAAAAAAZAAAAGQAAAAVAAAAYAAAAAAAAAAAAAAADwAAACADAAAAAAAAAAAAAAEAAACgMgAAVgcAAKr4//8BAAAAf39/AAEAAABkAAAAAAAAABQAAABAHwAAAAAAACYAAAAAAAAAwOD//wAAAAAmAAAAZAAAABYAAABMAAAAAAAAAAAAAAAEAAAAAAAAAAEAAABZWVkKAAAAACgAAAAoAAAAZAAAAGQAAAAAAAAAzMzMAAAAAABQAAAAUAAAAGQAAABkAAAAAAAAABcAAAAUAAAAAAAAAAAAAAD/fwAA/38AAAAAAAAJAAAABAAAAF8AYAAeAAAAaAAAAAAAAAAAAAAAAAAAAAAAAAAAAAAAECcAABAnAAAAAAAAAAAAAAAAAAAAAAAAAAAAAAAAAAAAAAAAAAAAABQAAAAAAAAAwMD/AAAAAABkAAAAMgAAAAAAAABkAAAAAAAAAH9/fwAKAAAAIgAAABgAAAAAAAAAAAAAAAAAAAAAAAAAAAAAAAAAAAAkAAAAJAAAAAAAAAAHAAAAAAAAAAAAAAAAAAAAAAAAAAAAAAAAAAAAf39/ACUAAABYAAAAAAAAAAAAAAAAAAAAAAAAAAAAAAAAAAAAAAAAAAAAAAAAAAAAAAAAAAAAAAA/AAAAAAAAAKCGAQAAAAAAAAAAAAAAAAAMAAAAAQAAAAAAAAAAAAAAAAAAAB8AAABUAAAAAAAABQAAAAEAAAAAAAAAAAAAAAAAAAAAAAAAAAAAAAAAAAAAAAAAAAAAAAJ/f38AAAAAA8zMzADAwP8Af39/AAAAAAAAAAAAAAAAAAAAAAAAAAAAIQAAABgAAAAUAAAAOAQAALgaAAD4JQAACDQAABAAAAAmAAAACAAAAL0/AAAAAAAA"/>
+                <pr:smNativeData xmlns:pr="smNativeData" xmlns="smNativeData" val="SMDATA_15_LkR5ZhMAAAAlAAAAZAAAAA0AAAAAkAAAAJAAAACQAAAAkAAAAAAAAAAAAAAAAAAAAAEAAABQAAAAAAAAAAAA4D8AAAAAAADgPwAAAAAAAOA/AAAAAAAA4D8AAAAAAADgPwAAAAAAAOA/AAAAAAAA4D8AAAAAAADgPwAAAAAAAOA/AAAAAAAA4D8CAAAAjAAAAAAAAAAAAAAAQoX0DP///wgAAAAAAAAAAAAAAAAAAAAAAAAAAAAAAAAAAAAAZAAAAAEAAABAAAAAAAAAAAAAAAAAAAAAAAAAAAAAAAAAAAAAAAAAAAAAAAAAAAAAAAAAAAAAAAAAAAAAAAAAAAAAAAAAAAAAAAAAAAAAAAAAAAAAAAAAAAAAAAAAAAAAFAAAADwAAAAAAAAAAAAAAAAAAAkUAAAAAQAAABQAAAAUAAAAFAAAAAEAAAAAAAAAZAAAAGQAAAAAAAAAZAAAAGQAAAAVAAAAYAAAAAAAAAAAAAAADwAAACADAAAAAAAAAAAAAAEAAACgMgAAVgcAAKr4//8BAAAAf39/AAEAAABkAAAAAAAAABQAAABAHwAAAAAAACYAAAAAAAAAwOD//wAAAAAmAAAAZAAAABYAAABMAAAAAAAAAAAAAAAEAAAAAAAAAAEAAABZWVkKAAAAACgAAAAoAAAAZAAAAGQAAAAAAAAAzMzMAAAAAABQAAAAUAAAAGQAAABkAAAAAAAAABcAAAAUAAAAAAAAAAAAAAD/fwAA/38AAAAAAAAJAAAABAAAAF8AYAAeAAAAaAAAAAAAAAAAAAAAAAAAAAAAAAAAAAAAECcAABAnAAAAAAAAAAAAAAAAAAAAAAAAAAAAAAAAAAAAAAAAAAAAABQAAAAAAAAAwMD/AAAAAABkAAAAMgAAAAAAAABkAAAAAAAAAH9/fwAKAAAAIgAAABgAAAAAAAAAAAAAAAAAAAAAAAAAAAAAAAAAAAAkAAAAJAAAAAAAAAAHAAAAAAAAAAAAAAAAAAAAAAAAAAAAAAAAAAAAf39/ACUAAABYAAAAAAAAAAAAAAAAAAAAAAAAAAAAAAAAAAAAAAAAAAAAAAAAAAAAAAAAAAAAAAA/AAAAAAAAAKCGAQAAAAAAAAAAAAAAAAAMAAAAAQAAAAAAAAAAAAAAAAAAAB8AAABUAAAAAAAABQAAAAEAAAAAAAAAAAAAAAAAAAAAAAAAAAAAAAAAAAAAAAAAAAAAAAJ/f38AAAAAA8zMzADAwP8Af39/AAAAAAAAAAAAAAAAAAAAAAAAAAAAIQAAABgAAAAUAAAAOAQAALgaAAD4JQAACDQAABAAAAAmAAAACAAAAL0/AAAAAAAA"/>
               </a:ext>
             </a:extLst>
           </p:cNvSpPr>
@@ -2051,7 +1927,7 @@
             <a:spLocks noGrp="1" noChangeArrowheads="1"/>
             <a:extLst>
               <a:ext uri="smNativeData">
-                <pr:smNativeData xmlns:pr="smNativeData" xmlns="smNativeData" val="SMDATA_15_EkJ5ZhMAAAAlAAAACwAAAA0AAAAACAcAADgEAAAoIwAAUBkAAAAAAAAAAAAAAAAAAAEAAABQAAAAAAAAAAAA4D8AAAAAAADgPwAAAAAAAOA/AAAAAAAA4D8AAAAAAADgPwAAAAAAAOA/AAAAAAAA4D8AAAAAAADgPwAAAAAAAOA/AAAAAAAA4D8CAAAAjAAAAAAAAAAAAAAAQoX0DP///wgAAAAAAAAAAAAAAAAAAAAAAAAAAAAAAAAAAAAAZAAAAAEAAABAAAAAAAAAAAAAAAAAAAAAAAAAAAAAAAAAAAAAAAAAAAAAAAAAAAAAAAAAAAAAAAAAAAAAAAAAAAAAAAAAAAAAAAAAAAAAAAAAAAAAAAAAAAAAAAAAAAAAFAAAADwAAAABAAAAAAAAAAAAAAAPAAAAAQAAACMAAAAjAAAAIwAAAB4AAAAAAAAASwAAAEsAAAAAAAAASwAAAEsAAAAVAAAAYAAAAAAAAAAAAAAADwAAACADAAAAAAAAAAAAAAEAAACgMgAAVgcAAKr4//8BAAAAf39/AAEAAABkAAAAAAAAABQAAABAHwAAAAAAACYAAAAAAAAAwOD//wAAAAAmAAAAZAAAABYAAABMAAAAAAAAAAAAAAAEAAAAAAAAAAEAAABZWVkKAAAAACgAAAAoAAAAZAAAAGQAAAAAAAAAzMzMAAAAAABQAAAAUAAAAGQAAABkAAAAAAAAABcAAAAUAAAAAAAAAAAAAAD/fwAA/38AAAAAAAAJAAAABAAAAAAAAAAeAAAAaAAAAAAAAAAAAAAAAAAAAAAAAAAAAAAAECcAABAnAAAAAAAAAAAAAAAAAAAAAAAAAAAAAAAAAAAAAAAAAAAAABQAAAAAAAAAwMD/AAAAAABkAAAAMgAAAAAAAABkAAAAAAAAAH9/fwAKAAAAIgAAABgAAAAAAAAAAAAAAAAAAAAAAAAAAAAAAAAAAAAkAAAAJAAAAAAAAAAHAAAAAAAAAAAAAAAAAAAAAAAAAAAAAAAAAAAAf39/ACUAAABYAAAAAAAAAAAAAAAAAAAAAAAAAAAAAAAAAAAAAAAAAAAAAAAAAAAAAAAAAAAAAAA/AAAAAAAAAKCGAQAAAAAAAAAAAAAAAAAMAAAAAQAAAAAAAAAAAAAAAAAAAB8AAABUAAAAAAAABQAAAAEAAAAAAAAAAAAAAAAAAAAAAAAAAAAAAAAAAAAAAAAAAAAAAAB/f38AAAAAA8zMzADAwP8Af39/AAAAAAAAAAAAAAAAAAAAAAAAAAAAIQAAABgAAAAUAAAACAcAADgEAAAoIwAAUBkAABAAAAAmAAAACAAAAAEPAAAAAAAA"/>
+                <pr:smNativeData xmlns:pr="smNativeData" xmlns="smNativeData" val="SMDATA_15_LkR5ZhMAAAAlAAAACwAAAA0AAAAACAcAADgEAAAoIwAAUBkAAAAAAAAAAAAAAAAAAAEAAABQAAAAAAAAAAAA4D8AAAAAAADgPwAAAAAAAOA/AAAAAAAA4D8AAAAAAADgPwAAAAAAAOA/AAAAAAAA4D8AAAAAAADgPwAAAAAAAOA/AAAAAAAA4D8CAAAAjAAAAAAAAAAAAAAAQoX0DP///wgAAAAAAAAAAAAAAAAAAAAAAAAAAAAAAAAAAAAAZAAAAAEAAABAAAAAAAAAAAAAAAAAAAAAAAAAAAAAAAAAAAAAAAAAAAAAAAAAAAAAAAAAAAAAAAAAAAAAAAAAAAAAAAAAAAAAAAAAAAAAAAAAAAAAAAAAAAAAAAAAAAAAFAAAADwAAAABAAAAAAAAAAAAAAAPAAAAAQAAACMAAAAjAAAAIwAAAB4AAAAAAAAASwAAAEsAAAAAAAAASwAAAEsAAAAVAAAAYAAAAAAAAAAAAAAADwAAACADAAAAAAAAAAAAAAEAAACgMgAAVgcAAKr4//8BAAAAf39/AAEAAABkAAAAAAAAABQAAABAHwAAAAAAACYAAAAAAAAAwOD//wAAAAAmAAAAZAAAABYAAABMAAAAAAAAAAAAAAAEAAAAAAAAAAEAAABZWVkKAAAAACgAAAAoAAAAZAAAAGQAAAAAAAAAzMzMAAAAAABQAAAAUAAAAGQAAABkAAAAAAAAABcAAAAUAAAAAAAAAAAAAAD/fwAA/38AAAAAAAAJAAAABAAAAAAAAAAeAAAAaAAAAAAAAAAAAAAAAAAAAAAAAAAAAAAAECcAABAnAAAAAAAAAAAAAAAAAAAAAAAAAAAAAAAAAAAAAAAAAAAAABQAAAAAAAAAwMD/AAAAAABkAAAAMgAAAAAAAABkAAAAAAAAAH9/fwAKAAAAIgAAABgAAAAAAAAAAAAAAAAAAAAAAAAAAAAAAAAAAAAkAAAAJAAAAAAAAAAHAAAAAAAAAAAAAAAAAAAAAAAAAAAAAAAAAAAAf39/ACUAAABYAAAAAAAAAAAAAAAAAAAAAAAAAAAAAAAAAAAAAAAAAAAAAAAAAAAAAAAAAAAAAAA/AAAAAAAAAKCGAQAAAAAAAAAAAAAAAAAMAAAAAQAAAAAAAAAAAAAAAAAAAB8AAABUAAAAAAAABQAAAAEAAAAAAAAAAAAAAAAAAAAAAAAAAAAAAAAAAAAAAAAAAAAAAAB/f38AAAAAA8zMzADAwP8Af39/AAAAAAAAAAAAAAAAAAAAAAAAAAAAIQAAABgAAAAUAAAACAcAADgEAAAoIwAAUBkAABAAAAAmAAAACAAAAAEPAAAAAAAA"/>
               </a:ext>
             </a:extLst>
           </p:cNvSpPr>
@@ -2097,7 +1973,7 @@
             <a:spLocks noGrp="1" noChangeArrowheads="1"/>
             <a:extLst>
               <a:ext uri="smNativeData">
-                <pr:smNativeData xmlns:pr="smNativeData" xmlns="smNativeData" val="SMDATA_15_EkJ5ZhMAAAAlAAAAZAAAAA0AAAAAkAAAAJAAAACQAAAAkAAAAAAAAAAAAAAAAAAAAAEAAABQAAAAAAAAAAAA4D8AAAAAAADgPwAAAAAAAOA/AAAAAAAA4D8AAAAAAADgPwAAAAAAAOA/AAAAAAAA4D8AAAAAAADgPwAAAAAAAOA/AAAAAAAA4D8CAAAAjAAAAAAAAAAAAAAAQoX0DP///wgAAAAAAAAAAAAAAAAAAAAAAAAAAAAAAAAAAAAAZAAAAAEAAABAAAAAAAAAAAAAAAAAAAAAAAAAAAAAAAAAAAAAAAAAAAAAAAAAAAAAAAAAAAAAAAAAAAAAAAAAAAAAAAAAAAAAAAAAAAAAAAAAAAAAAAAAAAAAAAAAAAAAFAAAADwAAAAAAAAAAAAAAAAAAAkUAAAAAQAAABQAAAAUAAAAFAAAAAEAAAAAAAAAZAAAAGQAAAAAAAAAZAAAAGQAAAAVAAAAYAAAAAAAAAAAAAAADwAAACADAAAAAAAAAAAAAAEAAACgMgAAVgcAAKr4//8BAAAAf39/AAEAAABkAAAAAAAAABQAAABAHwAAAAAAACYAAAAAAAAAwOD//wAAAAAmAAAAZAAAABYAAABMAAAAAAAAAAAAAAAEAAAAAAAAAAEAAABZWVkKAAAAACgAAAAoAAAAZAAAAGQAAAAAAAAAzMzMAAAAAABQAAAAUAAAAGQAAABkAAAAAAAAABcAAAAUAAAAAAAAAAAAAAD/fwAA/38AAAAAAAAJAAAABAAAAPDbzXceAAAAaAAAAAAAAAAAAAAAAAAAAAAAAAAAAAAAECcAABAnAAAAAAAAAAAAAAAAAAAAAAAAAAAAAAAAAAAAAAAAAAAAABQAAAAAAAAAwMD/AAAAAABkAAAAMgAAAAAAAABkAAAAAAAAAH9/fwAKAAAAIgAAABgAAAAAAAAAAAAAAAAAAAAAAAAAAAAAAAAAAAAkAAAAJAAAAAAAAAAHAAAAAAAAAAAAAAAAAAAAAAAAAAAAAAAAAAAAf39/ACUAAABYAAAAAAAAAAAAAAAAAAAAAAAAAAAAAAAAAAAAAAAAAAAAAAAAAAAAAAAAAAAAAAA/AAAAAAAAAKCGAQAAAAAAAAAAAAAAAAAMAAAAAQAAAAAAAAAAAAAAAAAAAB8AAABUAAAAAAAABQAAAAEAAAAAAAAAAAAAAAAAAAAAAAAAAAAAAAAAAAAAAAAAAAAAAAJ/f38AAAAAA8zMzADAwP8Af39/AAAAAAAAAAAAAAAAAAAAAAAAAAAAIQAAABgAAAAUAAAAOAQAALgaAAD4JQAACDQAABAAAAAmAAAACAAAAL0/AAAAAAAA"/>
+                <pr:smNativeData xmlns:pr="smNativeData" xmlns="smNativeData" val="SMDATA_15_LkR5ZhMAAAAlAAAAZAAAAA0AAAAAkAAAAJAAAACQAAAAkAAAAAAAAAAAAAAAAAAAAAEAAABQAAAAAAAAAAAA4D8AAAAAAADgPwAAAAAAAOA/AAAAAAAA4D8AAAAAAADgPwAAAAAAAOA/AAAAAAAA4D8AAAAAAADgPwAAAAAAAOA/AAAAAAAA4D8CAAAAjAAAAAAAAAAAAAAAQoX0DP///wgAAAAAAAAAAAAAAAAAAAAAAAAAAAAAAAAAAAAAZAAAAAEAAABAAAAAAAAAAAAAAAAAAAAAAAAAAAAAAAAAAAAAAAAAAAAAAAAAAAAAAAAAAAAAAAAAAAAAAAAAAAAAAAAAAAAAAAAAAAAAAAAAAAAAAAAAAAAAAAAAAAAAFAAAADwAAAAAAAAAAAAAAAAAAAkUAAAAAQAAABQAAAAUAAAAFAAAAAEAAAAAAAAAZAAAAGQAAAAAAAAAZAAAAGQAAAAVAAAAYAAAAAAAAAAAAAAADwAAACADAAAAAAAAAAAAAAEAAACgMgAAVgcAAKr4//8BAAAAf39/AAEAAABkAAAAAAAAABQAAABAHwAAAAAAACYAAAAAAAAAwOD//wAAAAAmAAAAZAAAABYAAABMAAAAAAAAAAAAAAAEAAAAAAAAAAEAAABZWVkKAAAAACgAAAAoAAAAZAAAAGQAAAAAAAAAzMzMAAAAAABQAAAAUAAAAGQAAABkAAAAAAAAABcAAAAUAAAAAAAAAAAAAAD/fwAA/38AAAAAAAAJAAAABAAAAPDbzXceAAAAaAAAAAAAAAAAAAAAAAAAAAAAAAAAAAAAECcAABAnAAAAAAAAAAAAAAAAAAAAAAAAAAAAAAAAAAAAAAAAAAAAABQAAAAAAAAAwMD/AAAAAABkAAAAMgAAAAAAAABkAAAAAAAAAH9/fwAKAAAAIgAAABgAAAAAAAAAAAAAAAAAAAAAAAAAAAAAAAAAAAAkAAAAJAAAAAAAAAAHAAAAAAAAAAAAAAAAAAAAAAAAAAAAAAAAAAAAf39/ACUAAABYAAAAAAAAAAAAAAAAAAAAAAAAAAAAAAAAAAAAAAAAAAAAAAAAAAAAAAAAAAAAAAA/AAAAAAAAAKCGAQAAAAAAAAAAAAAAAAAMAAAAAQAAAAAAAAAAAAAAAAAAAB8AAABUAAAAAAAABQAAAAEAAAAAAAAAAAAAAAAAAAAAAAAAAAAAAAAAAAAAAAAAAAAAAAJ/f38AAAAAA8zMzADAwP8Af39/AAAAAAAAAAAAAAAAAAAAAAAAAAAAIQAAABgAAAAUAAAAOAQAALgaAAD4JQAACDQAABAAAAAmAAAACAAAAL0/AAAAAAAA"/>
               </a:ext>
             </a:extLst>
           </p:cNvSpPr>
@@ -2165,7 +2041,7 @@
           <p:cNvPicPr>
             <a:extLst>
               <a:ext uri="smNativeData">
-                <pr:smNativeData xmlns:pr="smNativeData" xmlns="smNativeData" val="SMDATA_17_EkJ5ZhMAAAAlAAAAEQAAAA0AAAAAkAAAAEgAAACQAAAASAAAAAAAAAAAAAAAAAAAAAEAAABQAAAAAAAAAAAA4D8AAAAAAADgPwAAAAAAAOA/AAAAAAAA4D8AAAAAAADgPwAAAAAAAOA/AAAAAAAA4D8AAAAAAADgPwAAAAAAAOA/AAAAAAAA4D8CAAAAjAAAAAAAAAAAAAAAQoX0DP///wgAAAAAAAAAAAAAAAAAAAAAAAAAAAAAAAAAAAAAZAAAAAEAAABAAAAAAAAAAAAAAAAAAAAAAAAAAAAAAAAAAAAAAAAAAAAAAAAAAAAAAAAAAAAAAAAAAAAAAAAAAAAAAAAAAAAAAAAAAAAAAAAAAAAAAAAAAAAAAAAAAAAAFAAAADwAAAAAAAAAAAAAAAAAAAkUAAAAAQAAABQAAAAUAAAAFAAAAAEAAAAAAAAAZAAAAGQAAAAAAAAAZAAAAGQAAAAVAAAAYAAAAAAAAAAAAAAADwAAACADAAAAAAAAAAAAAAEAAACgMgAAVgcAAKr4//8BAAAAf39/AAEAAABkAAAAAAAAABQAAABAHwAAAAAAACYAAAAAAAAAwOD//wAAAAAmAAAAZAAAABYAAABMAAAAAAAAAAAAAAAEAAAAAAAAAAEAAABZWVkKAAAAACgAAAAoAAAAZAAAAGQAAAAAAAAAzMzMAAAAAABQAAAAUAAAAGQAAABkAAAAAAAAAAcAAAA4AAAAAAAAAAAAAAAAAAAA////AAAAAAAAAAAAAAAAAAAAAAAAAAAAAAAAAAAAAABkAAAAZAAAAAAAAAAjAAAABAAAAGQAAAAXAAAAFAAAAAAAAAAAAAAA/38AAP9/AAAAAAAACQAAAAQAAAAlAwAAHgAAAGgAAAAAAAAAAAAAAAAAAAAAAAAAAAAAABAnAAAQJwAAAAAAAAAAAAAAAAAAAAAAAAAAAAAAAAAAAAAAAAAAAAAUAAAAAAAAAMDA/wAAAAAAZAAAADIAAAAAAAAAZAAAAAAAAAB/f38ACgAAACIAAAAYAAAAAAAAAAAAAAAAAAAAAAAAAAAAAAAAAAAAJAAAACQAAAAAAAAABwAAAAAAAAAAAAAAAAAAAAAAAAAAAAAAAAAAAH9/fwAlAAAAWAAAAAAAAAAAAAAAAAAAAAAAAAAAAAAAAAAAAAAAAAAAAAAAAAAAAAAAAAAAAAAAPwAAAAAAAACghgEAAAAAAAAAAAAAAAAADAAAAAEAAAAAAAAAAAAAAAAAAAAfAAAAVAAAAEKF9AX///8BAAAAAAAAAAAAAAAAAAAAAAAAAAAAAAAAAAAAAAAAAAAAAAACf39/AFlZWQPMzMwAwMD/AH9/fwAAAAAAAAAAAAAAAAD///8AAAAAACEAAAAYAAAAFAAAAOT////r////XDgAAEUqAAAQAAAAJgAAAAgAAAD//////////w=="/>
+                <pr:smNativeData xmlns:pr="smNativeData" xmlns="smNativeData" val="SMDATA_17_LkR5ZhMAAAAlAAAAEQAAAA0AAAAAkAAAAEgAAACQAAAASAAAAAAAAAAAAAAAAAAAAAEAAABQAAAAAAAAAAAA4D8AAAAAAADgPwAAAAAAAOA/AAAAAAAA4D8AAAAAAADgPwAAAAAAAOA/AAAAAAAA4D8AAAAAAADgPwAAAAAAAOA/AAAAAAAA4D8CAAAAjAAAAAAAAAAAAAAAQoX0DP///wgAAAAAAAAAAAAAAAAAAAAAAAAAAAAAAAAAAAAAZAAAAAEAAABAAAAAAAAAAAAAAAAAAAAAAAAAAAAAAAAAAAAAAAAAAAAAAAAAAAAAAAAAAAAAAAAAAAAAAAAAAAAAAAAAAAAAAAAAAAAAAAAAAAAAAAAAAAAAAAAAAAAAFAAAADwAAAAAAAAAAAAAAAAAAAkUAAAAAQAAABQAAAAUAAAAFAAAAAEAAAAAAAAAZAAAAGQAAAAAAAAAZAAAAGQAAAAVAAAAYAAAAAAAAAAAAAAADwAAACADAAAAAAAAAAAAAAEAAACgMgAAVgcAAKr4//8BAAAAf39/AAEAAABkAAAAAAAAABQAAABAHwAAAAAAACYAAAAAAAAAwOD//wAAAAAmAAAAZAAAABYAAABMAAAAAAAAAAAAAAAEAAAAAAAAAAEAAABZWVkKAAAAACgAAAAoAAAAZAAAAGQAAAAAAAAAzMzMAAAAAABQAAAAUAAAAGQAAABkAAAAAAAAAAcAAAA4AAAAAAAAAAAAAAAAAAAA////AAAAAAAAAAAAAAAAAAAAAAAAAAAAAAAAAAAAAABkAAAAZAAAAAAAAAAjAAAABAAAAGQAAAAXAAAAFAAAAAAAAAAAAAAA/38AAP9/AAAAAAAACQAAAAQAAAAlAwAAHgAAAGgAAAAAAAAAAAAAAAAAAAAAAAAAAAAAABAnAAAQJwAAAAAAAAAAAAAAAAAAAAAAAAAAAAAAAAAAAAAAAAAAAAAUAAAAAAAAAMDA/wAAAAAAZAAAADIAAAAAAAAAZAAAAAAAAAB/f38ACgAAACIAAAAYAAAAAAAAAAAAAAAAAAAAAAAAAAAAAAAAAAAAJAAAACQAAAAAAAAABwAAAAAAAAAAAAAAAAAAAAAAAAAAAAAAAAAAAH9/fwAlAAAAWAAAAAAAAAAAAAAAAAAAAAAAAAAAAAAAAAAAAAAAAAAAAAAAAAAAAAAAAAAAAAAAPwAAAAAAAACghgEAAAAAAAAAAAAAAAAADAAAAAEAAAAAAAAAAAAAAAAAAAAfAAAAVAAAAEKF9AX///8BAAAAAAAAAAAAAAAAAAAAAAAAAAAAAAAAAAAAAAAAAAAAAAACf39/AFlZWQPMzMwAwMD/AH9/fwAAAAAAAAAAAAAAAAD///8AAAAAACEAAAAYAAAAFAAAAOT////r////XDgAAEUqAAAQAAAAJgAAAAgAAAD//////////w=="/>
               </a:ext>
             </a:extLst>
           </p:cNvPicPr>
@@ -2199,7 +2075,7 @@
             <a:spLocks noGrp="1" noChangeArrowheads="1"/>
             <a:extLst>
               <a:ext uri="smNativeData">
-                <pr:smNativeData xmlns:pr="smNativeData" xmlns="smNativeData" val="SMDATA_15_EkJ5ZhMAAAAlAAAAZAAAAA0AAAAAkAAAAJAAAACQAAAAkAAAAAAAAAAAAAAAAAAAAAEAAABQAAAAAAAAAAAA4D8AAAAAAADgPwAAAAAAAOA/AAAAAAAA4D8AAAAAAADgPwAAAAAAAOA/AAAAAAAA4D8AAAAAAADgPwAAAAAAAOA/AAAAAAAA4D8CAAAAjAAAAAAAAAAAAAAAQoX0DP///wgAAAAAAAAAAAAAAAAAAAAAAAAAAAAAAAAAAAAAZAAAAAEAAABAAAAAAAAAAAAAAAAAAAAAAAAAAAAAAAAAAAAAAAAAAAAAAAAAAAAAAAAAAAAAAAAAAAAAAAAAAAAAAAAAAAAAAAAAAAAAAAAAAAAAAAAAAAAAAAAAAAAAFAAAADwAAAAAAAAAAAAAAAAAAAkUAAAAAQAAABQAAAAUAAAAFAAAAAEAAAAAAAAAZAAAAGQAAAAAAAAAZAAAAGQAAAAVAAAAYAAAAAAAAAAAAAAADwAAACADAAAAAAAAAAAAAAEAAACgMgAAVgcAAKr4//8BAAAAf39/AAEAAABkAAAAAAAAABQAAABAHwAAAAAAACYAAAAAAAAAwOD//wAAAAAmAAAAZAAAABYAAABMAAAAAAAAAAAAAAAEAAAAAAAAAAEAAABZWVkKAAAAACgAAAAoAAAAZAAAAGQAAAAAAAAAzMzMAAAAAABQAAAAUAAAAGQAAABkAAAAAAAAABcAAAAUAAAAAAAAAAAAAAD/fwAA/38AAAAAAAAJAAAABAAAAAAAAAAeAAAAaAAAAAAAAAAAAAAAAAAAAAAAAAAAAAAAECcAABAnAAAAAAAAAAAAAAAAAAAAAAAAAAAAAAAAAAAAAAAAAAAAABQAAAAAAAAAwMD/AAAAAABkAAAAMgAAAAAAAABkAAAAAAAAAH9/fwAKAAAAIgAAABgAAAAAAAAAAAAAAAAAAAAAAAAAAAAAAAAAAAAkAAAAJAAAAAAAAAAHAAAAAAAAAAAAAAAAAAAAAAAAAAAAAAAAAAAAf39/ACUAAABYAAAAAAAAAAAAAAAAAAAAAAAAAAAAAAAAAAAAAAAAAAAAAAAAAAAAAAAAAAAAAAA/AAAAAAAAAKCGAQAAAAAAAAAAAAAAAAAMAAAAAQAAAAAAAAAAAAAAAAAAAB8AAABUAAAAAAAABQAAAAEAAAAAAAAAAAAAAAAAAAAAAAAAAAAAAAAAAAAAAAAAAAAAAAJ/f38AAAAAA8zMzADAwP8Af39/AAAAAAAAAAAAAAAAAAAAAAAAAAAAIQAAABgAAAAUAAAA5wQAAD8jAAD6IwAAvykAABAAAAAmAAAACAAAAD2wAAAAAAAA"/>
+                <pr:smNativeData xmlns:pr="smNativeData" xmlns="smNativeData" val="SMDATA_15_LkR5ZhMAAAAlAAAAZAAAAA0AAAAAkAAAAJAAAACQAAAAkAAAAAAAAAAAAAAAAAAAAAEAAABQAAAAAAAAAAAA4D8AAAAAAADgPwAAAAAAAOA/AAAAAAAA4D8AAAAAAADgPwAAAAAAAOA/AAAAAAAA4D8AAAAAAADgPwAAAAAAAOA/AAAAAAAA4D8CAAAAjAAAAAAAAAAAAAAAQoX0DP///wgAAAAAAAAAAAAAAAAAAAAAAAAAAAAAAAAAAAAAZAAAAAEAAABAAAAAAAAAAAAAAAAAAAAAAAAAAAAAAAAAAAAAAAAAAAAAAAAAAAAAAAAAAAAAAAAAAAAAAAAAAAAAAAAAAAAAAAAAAAAAAAAAAAAAAAAAAAAAAAAAAAAAFAAAADwAAAAAAAAAAAAAAAAAAAkUAAAAAQAAABQAAAAUAAAAFAAAAAEAAAAAAAAAZAAAAGQAAAAAAAAAZAAAAGQAAAAVAAAAYAAAAAAAAAAAAAAADwAAACADAAAAAAAAAAAAAAEAAACgMgAAVgcAAKr4//8BAAAAf39/AAEAAABkAAAAAAAAABQAAABAHwAAAAAAACYAAAAAAAAAwOD//wAAAAAmAAAAZAAAABYAAABMAAAAAAAAAAAAAAAEAAAAAAAAAAEAAABZWVkKAAAAACgAAAAoAAAAZAAAAGQAAAAAAAAAzMzMAAAAAABQAAAAUAAAAGQAAABkAAAAAAAAABcAAAAUAAAAAAAAAAAAAAD/fwAA/38AAAAAAAAJAAAABAAAAAAAAAAeAAAAaAAAAAAAAAAAAAAAAAAAAAAAAAAAAAAAECcAABAnAAAAAAAAAAAAAAAAAAAAAAAAAAAAAAAAAAAAAAAAAAAAABQAAAAAAAAAwMD/AAAAAABkAAAAMgAAAAAAAABkAAAAAAAAAH9/fwAKAAAAIgAAABgAAAAAAAAAAAAAAAAAAAAAAAAAAAAAAAAAAAAkAAAAJAAAAAAAAAAHAAAAAAAAAAAAAAAAAAAAAAAAAAAAAAAAAAAAf39/ACUAAABYAAAAAAAAAAAAAAAAAAAAAAAAAAAAAAAAAAAAAAAAAAAAAAAAAAAAAAAAAAAAAAA/AAAAAAAAAKCGAQAAAAAAAAAAAAAAAAAMAAAAAQAAAAAAAAAAAAAAAAAAAB8AAABUAAAAAAAABQAAAAEAAAAAAAAAAAAAAAAAAAAAAAAAAAAAAAAAAAAAAAAAAAAAAAJ/f38AAAAAA8zMzADAwP8Af39/AAAAAAAAAAAAAAAAAAAAAAAAAAAAIQAAABgAAAAUAAAA5wQAAD8jAAD6IwAAvykAABAAAAAmAAAACAAAAD2wAAAAAAAA"/>
               </a:ext>
             </a:extLst>
           </p:cNvSpPr>
@@ -2354,7 +2230,7 @@
             <a:spLocks noGrp="1" noChangeArrowheads="1"/>
             <a:extLst>
               <a:ext uri="smNativeData">
-                <pr:smNativeData xmlns:pr="smNativeData" xmlns="smNativeData" val="SMDATA_15_EkJ5ZhMAAAAlAAAAZAAAAA0AAAAAkAAAAJAAAACQAAAAkAAAAAAAAAAAAAAAAAAAAAEAAABQAAAAAAAAAAAA4D8AAAAAAADgPwAAAAAAAOA/AAAAAAAA4D8AAAAAAADgPwAAAAAAAOA/AAAAAAAA4D8AAAAAAADgPwAAAAAAAOA/AAAAAAAA4D8CAAAAjAAAAAAAAAAAAAAAQoX0DP///wgAAAAAAAAAAAAAAAAAAAAAAAAAAAAAAAAAAAAAZAAAAAEAAABAAAAAAAAAAAAAAAAAAAAAAAAAAAAAAAAAAAAAAAAAAAAAAAAAAAAAAAAAAAAAAAAAAAAAAAAAAAAAAAAAAAAAAAAAAAAAAAAAAAAAAAAAAAAAAAAAAAAAFAAAADwAAAAAAAAAAAAAAAAAAAkUAAAAAQAAABQAAAAUAAAAFAAAAAEAAAAAAAAAZAAAAGQAAAAAAAAAZAAAAGQAAAAVAAAAYAAAAAAAAAAAAAAADwAAACADAAAAAAAAAAAAAAEAAACgMgAAVgcAAKr4//8BAAAAf39/AAEAAABkAAAAAAAAABQAAABAHwAAAAAAACYAAAAAAAAAwOD//wAAAAAmAAAAZAAAABYAAABMAAAAAAAAAAAAAAAEAAAAAAAAAAEAAABZWVkKAAAAACgAAAAoAAAAZAAAAGQAAAAAAAAAzMzMAAAAAABQAAAAUAAAAGQAAABkAAAAAAAAABcAAAAUAAAAAAAAAAAAAAD/fwAA/38AAAAAAAAJAAAABAAAAAAAAAAeAAAAaAAAAAAAAAAAAAAAAAAAAAAAAAAAAAAAECcAABAnAAAAAAAAAAAAAAAAAAAAAAAAAAAAAAAAAAAAAAAAAAAAABQAAAAAAAAAwMD/AAAAAABkAAAAMgAAAAAAAABkAAAAAAAAAH9/fwAKAAAAIgAAABgAAAAAAAAAAAAAAAAAAAAAAAAAAAAAAAAAAAAkAAAAJAAAAAAAAAAHAAAAAAAAAAAAAAAAAAAAAAAAAAAAAAAAAAAAf39/ACUAAABYAAAAAAAAAAAAAAAAAAAAAAAAAAAAAAAAAAAAAAAAAAAAAAAAAAAAAAAAAAAAAAA/AAAAAAAAAKCGAQAAAAAAAAAAAAAAAAAMAAAAAQAAAAAAAAAAAAAAAAAAAB8AAABUAAAAAAAABQAAAAEAAAAAAAAAAAAAAAAAAAAAAAAAAAAAAAAAAAAAAAAAAAAAAAJ/f38AAAAAA8zMzADAwP8Af39/AAAAAAAAAAAAAAAAAAAAAAAAAAAAIQAAABgAAAAUAAAA5wQAAMMPAACROAAAfyQAABAAAAAmAAAACAAAAD2wAAAAAAAA"/>
+                <pr:smNativeData xmlns:pr="smNativeData" xmlns="smNativeData" val="SMDATA_15_LkR5ZhMAAAAlAAAAZAAAAA0AAAAAkAAAAJAAAACQAAAAkAAAAAAAAAAAAAAAAAAAAAEAAABQAAAAAAAAAAAA4D8AAAAAAADgPwAAAAAAAOA/AAAAAAAA4D8AAAAAAADgPwAAAAAAAOA/AAAAAAAA4D8AAAAAAADgPwAAAAAAAOA/AAAAAAAA4D8CAAAAjAAAAAAAAAAAAAAAQoX0DP///wgAAAAAAAAAAAAAAAAAAAAAAAAAAAAAAAAAAAAAZAAAAAEAAABAAAAAAAAAAAAAAAAAAAAAAAAAAAAAAAAAAAAAAAAAAAAAAAAAAAAAAAAAAAAAAAAAAAAAAAAAAAAAAAAAAAAAAAAAAAAAAAAAAAAAAAAAAAAAAAAAAAAAFAAAADwAAAAAAAAAAAAAAAAAAAkUAAAAAQAAABQAAAAUAAAAFAAAAAEAAAAAAAAAZAAAAGQAAAAAAAAAZAAAAGQAAAAVAAAAYAAAAAAAAAAAAAAADwAAACADAAAAAAAAAAAAAAEAAACgMgAAVgcAAKr4//8BAAAAf39/AAEAAABkAAAAAAAAABQAAABAHwAAAAAAACYAAAAAAAAAwOD//wAAAAAmAAAAZAAAABYAAABMAAAAAAAAAAAAAAAEAAAAAAAAAAEAAABZWVkKAAAAACgAAAAoAAAAZAAAAGQAAAAAAAAAzMzMAAAAAABQAAAAUAAAAGQAAABkAAAAAAAAABcAAAAUAAAAAAAAAAAAAAD/fwAA/38AAAAAAAAJAAAABAAAAAAAAAAeAAAAaAAAAAAAAAAAAAAAAAAAAAAAAAAAAAAAECcAABAnAAAAAAAAAAAAAAAAAAAAAAAAAAAAAAAAAAAAAAAAAAAAABQAAAAAAAAAwMD/AAAAAABkAAAAMgAAAAAAAABkAAAAAAAAAH9/fwAKAAAAIgAAABgAAAAAAAAAAAAAAAAAAAAAAAAAAAAAAAAAAAAkAAAAJAAAAAAAAAAHAAAAAAAAAAAAAAAAAAAAAAAAAAAAAAAAAAAAf39/ACUAAABYAAAAAAAAAAAAAAAAAAAAAAAAAAAAAAAAAAAAAAAAAAAAAAAAAAAAAAAAAAAAAAA/AAAAAAAAAKCGAQAAAAAAAAAAAAAAAAAMAAAAAQAAAAAAAAAAAAAAAAAAAB8AAABUAAAAAAAABQAAAAEAAAAAAAAAAAAAAAAAAAAAAAAAAAAAAAAAAAAAAAAAAAAAAAJ/f38AAAAAA8zMzADAwP8Af39/AAAAAAAAAAAAAAAAAAAAAAAAAAAAIQAAABgAAAAUAAAA5wQAAMMPAACROAAAfyQAABAAAAAmAAAACAAAAD2wAAAAAAAA"/>
               </a:ext>
             </a:extLst>
           </p:cNvSpPr>
@@ -2534,7 +2410,7 @@
             <a:spLocks noGrp="1" noChangeArrowheads="1"/>
             <a:extLst>
               <a:ext uri="smNativeData">
-                <pr:smNativeData xmlns:pr="smNativeData" xmlns="smNativeData" val="SMDATA_15_EkJ5ZhMAAAAlAAAAZAAAAA0AAAAAkAAAAJAAAACQAAAAkAAAAAAAAAAAAAAAAAAAAAEAAABQAAAAAAAAAAAA4D8AAAAAAADgPwAAAAAAAOA/AAAAAAAA4D8AAAAAAADgPwAAAAAAAOA/AAAAAAAA4D8AAAAAAADgPwAAAAAAAOA/AAAAAAAA4D8CAAAAjAAAAAAAAAAAAAAAQoX0DP///wgAAAAAAAAAAAAAAAAAAAAAAAAAAAAAAAAAAAAAZAAAAAEAAABAAAAAAAAAAAAAAAAAAAAAAAAAAAAAAAAAAAAAAAAAAAAAAAAAAAAAAAAAAAAAAAAAAAAAAAAAAAAAAAAAAAAAAAAAAAAAAAAAAAAAAAAAAAAAAAAAAAAAFAAAADwAAAAAAAAAAAAAAAAAAAkUAAAAAQAAABQAAAAUAAAAFAAAAAEAAAAAAAAAZAAAAGQAAAAAAAAAZAAAAGQAAAAVAAAAYAAAAAAAAAAAAAAADwAAACADAAAAAAAAAAAAAAEAAACgMgAAVgcAAKr4//8BAAAAf39/AAEAAABkAAAAAAAAABQAAABAHwAAAAAAACYAAAAAAAAAwOD//wAAAAAmAAAAZAAAABYAAABMAAAAAAAAAAAAAAAEAAAAAAAAAAEAAABZWVkKAAAAACgAAAAoAAAAZAAAAGQAAAAAAAAAzMzMAAAAAABQAAAAUAAAAGQAAABkAAAAAAAAABcAAAAUAAAAAAAAAAAAAAD/fwAA/38AAAAAAAAJAAAABAAAAAAAAAAeAAAAaAAAAAAAAAAAAAAAAAAAAAAAAAAAAAAAECcAABAnAAAAAAAAAAAAAAAAAAAAAAAAAAAAAAAAAAAAAAAAAAAAABQAAAAAAAAAwMD/AAAAAABkAAAAMgAAAAAAAABkAAAAAAAAAH9/fwAKAAAAIgAAABgAAAAAAAAAAAAAAAAAAAAAAAAAAAAAAAAAAAAkAAAAJAAAAAAAAAAHAAAAAAAAAAAAAAAAAAAAAAAAAAAAAAAAAAAAf39/ACUAAABYAAAAAAAAAAAAAAAAAAAAAAAAAAAAAAAAAAAAAAAAAAAAAAAAAAAAAAAAAAAAAAA/AAAAAAAAAKCGAQAAAAAAAAAAAAAAAAAMAAAAAQAAAAAAAAAAAAAAAAAAAB8AAABUAAAAAAAABQAAAAEAAAAAAAAAAAAAAAAAAAAAAAAAAAAAAAAAAAAAAAAAAAAAAAJ/f38AAAAAA8zMzADAwP8Af39/AAAAAAAAAAAAAAAAAAAAAAAAAAAAIQAAABgAAAAUAAAAFAMAALYCAAB/NwAAvwoAABAAAAAmAAAACAAAADywAAAAAAAA"/>
+                <pr:smNativeData xmlns:pr="smNativeData" xmlns="smNativeData" val="SMDATA_15_LkR5ZhMAAAAlAAAAZAAAAA0AAAAAkAAAAJAAAACQAAAAkAAAAAAAAAAAAAAAAAAAAAEAAABQAAAAAAAAAAAA4D8AAAAAAADgPwAAAAAAAOA/AAAAAAAA4D8AAAAAAADgPwAAAAAAAOA/AAAAAAAA4D8AAAAAAADgPwAAAAAAAOA/AAAAAAAA4D8CAAAAjAAAAAAAAAAAAAAAQoX0DP///wgAAAAAAAAAAAAAAAAAAAAAAAAAAAAAAAAAAAAAZAAAAAEAAABAAAAAAAAAAAAAAAAAAAAAAAAAAAAAAAAAAAAAAAAAAAAAAAAAAAAAAAAAAAAAAAAAAAAAAAAAAAAAAAAAAAAAAAAAAAAAAAAAAAAAAAAAAAAAAAAAAAAAFAAAADwAAAAAAAAAAAAAAAAAAAkUAAAAAQAAABQAAAAUAAAAFAAAAAEAAAAAAAAAZAAAAGQAAAAAAAAAZAAAAGQAAAAVAAAAYAAAAAAAAAAAAAAADwAAACADAAAAAAAAAAAAAAEAAACgMgAAVgcAAKr4//8BAAAAf39/AAEAAABkAAAAAAAAABQAAABAHwAAAAAAACYAAAAAAAAAwOD//wAAAAAmAAAAZAAAABYAAABMAAAAAAAAAAAAAAAEAAAAAAAAAAEAAABZWVkKAAAAACgAAAAoAAAAZAAAAGQAAAAAAAAAzMzMAAAAAABQAAAAUAAAAGQAAABkAAAAAAAAABcAAAAUAAAAAAAAAAAAAAD/fwAA/38AAAAAAAAJAAAABAAAAAAAAAAeAAAAaAAAAAAAAAAAAAAAAAAAAAAAAAAAAAAAECcAABAnAAAAAAAAAAAAAAAAAAAAAAAAAAAAAAAAAAAAAAAAAAAAABQAAAAAAAAAwMD/AAAAAABkAAAAMgAAAAAAAABkAAAAAAAAAH9/fwAKAAAAIgAAABgAAAAAAAAAAAAAAAAAAAAAAAAAAAAAAAAAAAAkAAAAJAAAAAAAAAAHAAAAAAAAAAAAAAAAAAAAAAAAAAAAAAAAAAAAf39/ACUAAABYAAAAAAAAAAAAAAAAAAAAAAAAAAAAAAAAAAAAAAAAAAAAAAAAAAAAAAAAAAAAAAA/AAAAAAAAAKCGAQAAAAAAAAAAAAAAAAAMAAAAAQAAAAAAAAAAAAAAAAAAAB8AAABUAAAAAAAABQAAAAEAAAAAAAAAAAAAAAAAAAAAAAAAAAAAAAAAAAAAAAAAAAAAAAJ/f38AAAAAA8zMzADAwP8Af39/AAAAAAAAAAAAAAAAAAAAAAAAAAAAIQAAABgAAAAUAAAAFAMAALYCAAB/NwAAvwoAABAAAAAmAAAACAAAADywAAAAAAAA"/>
               </a:ext>
             </a:extLst>
           </p:cNvSpPr>
@@ -2669,7 +2545,7 @@
             <a:spLocks noGrp="1" noChangeArrowheads="1"/>
             <a:extLst>
               <a:ext uri="smNativeData">
-                <pr:smNativeData xmlns:pr="smNativeData" xmlns="smNativeData" val="SMDATA_15_EkJ5ZhMAAAAlAAAAZAAAAA0AAAAAkAAAAJAAAACQAAAAkAAAAAAAAAAAAAAAAAAAAAEAAABQAAAAAAAAAAAA4D8AAAAAAADgPwAAAAAAAOA/AAAAAAAA4D8AAAAAAADgPwAAAAAAAOA/AAAAAAAA4D8AAAAAAADgPwAAAAAAAOA/AAAAAAAA4D8CAAAAjAAAAAAAAAAAAAAAQoX0DP///wgAAAAAAAAAAAAAAAAAAAAAAAAAAAAAAAAAAAAAZAAAAAEAAABAAAAAAAAAAAAAAAAAAAAAAAAAAAAAAAAAAAAAAAAAAAAAAAAAAAAAAAAAAAAAAAAAAAAAAAAAAAAAAAAAAAAAAAAAAAAAAAAAAAAAAAAAAAAAAAAAAAAAFAAAADwAAAAAAAAAAAAAAAAAAAkUAAAAAQAAABQAAAAUAAAAFAAAAAEAAAAAAAAAZAAAAGQAAAAAAAAAZAAAAGQAAAAVAAAAYAAAAAAAAAAAAAAADwAAACADAAAAAAAAAAAAAAEAAACgMgAAVgcAAKr4//8BAAAAf39/AAEAAABkAAAAAAAAABQAAABAHwAAAAAAACYAAAAAAAAAwOD//wAAAAAmAAAAZAAAABYAAABMAAAAAAAAAAAAAAAEAAAAAAAAAAEAAABZWVkKAAAAACgAAAAoAAAAZAAAAGQAAAAAAAAAzMzMAAAAAABQAAAAUAAAAGQAAABkAAAAAAAAABcAAAAUAAAAAAAAAAAAAAD/fwAA/38AAAAAAAAJAAAABAAAAAAAAAAeAAAAaAAAAAAAAAAAAAAAAAAAAAAAAAAAAAAAECcAABAnAAAAAAAAAAAAAAAAAAAAAAAAAAAAAAAAAAAAAAAAAAAAABQAAAAAAAAAwMD/AAAAAABkAAAAMgAAAAAAAABkAAAAAAAAAH9/fwAKAAAAIgAAABgAAAAAAAAAAAAAAAAAAAAAAAAAAAAAAAAAAAAkAAAAJAAAAAAAAAAHAAAAAAAAAAAAAAAAAAAAAAAAAAAAAAAAAAAAf39/ACUAAABYAAAAAAAAAAAAAAAAAAAAAAAAAAAAAAAAAAAAAAAAAAAAAAAAAAAAAAAAAAAAAAA/AAAAAAAAAKCGAQAAAAAAAAAAAAAAAAAMAAAAAQAAAAAAAAAAAAAAAAAAAB8AAABUAAAAAAAABQAAAAEAAAAAAAAAAAAAAAAAAAAAAAAAAAAAAAAAAAAAAAAAAAAAAAJ/f38AAAAAA8zMzADAwP8Af39/AAAAAAAAAAAAAAAAAAAAAAAAAAAAIQAAABgAAAAUAAAAFAMAALYCAAB/NwAAvwoAABAAAAAmAAAACAAAADywAAAAAAAA"/>
+                <pr:smNativeData xmlns:pr="smNativeData" xmlns="smNativeData" val="SMDATA_15_LkR5ZhMAAAAlAAAAZAAAAA0AAAAAkAAAAJAAAACQAAAAkAAAAAAAAAAAAAAAAAAAAAEAAABQAAAAAAAAAAAA4D8AAAAAAADgPwAAAAAAAOA/AAAAAAAA4D8AAAAAAADgPwAAAAAAAOA/AAAAAAAA4D8AAAAAAADgPwAAAAAAAOA/AAAAAAAA4D8CAAAAjAAAAAAAAAAAAAAAQoX0DP///wgAAAAAAAAAAAAAAAAAAAAAAAAAAAAAAAAAAAAAZAAAAAEAAABAAAAAAAAAAAAAAAAAAAAAAAAAAAAAAAAAAAAAAAAAAAAAAAAAAAAAAAAAAAAAAAAAAAAAAAAAAAAAAAAAAAAAAAAAAAAAAAAAAAAAAAAAAAAAAAAAAAAAFAAAADwAAAAAAAAAAAAAAAAAAAkUAAAAAQAAABQAAAAUAAAAFAAAAAEAAAAAAAAAZAAAAGQAAAAAAAAAZAAAAGQAAAAVAAAAYAAAAAAAAAAAAAAADwAAACADAAAAAAAAAAAAAAEAAACgMgAAVgcAAKr4//8BAAAAf39/AAEAAABkAAAAAAAAABQAAABAHwAAAAAAACYAAAAAAAAAwOD//wAAAAAmAAAAZAAAABYAAABMAAAAAAAAAAAAAAAEAAAAAAAAAAEAAABZWVkKAAAAACgAAAAoAAAAZAAAAGQAAAAAAAAAzMzMAAAAAABQAAAAUAAAAGQAAABkAAAAAAAAABcAAAAUAAAAAAAAAAAAAAD/fwAA/38AAAAAAAAJAAAABAAAAAAAAAAeAAAAaAAAAAAAAAAAAAAAAAAAAAAAAAAAAAAAECcAABAnAAAAAAAAAAAAAAAAAAAAAAAAAAAAAAAAAAAAAAAAAAAAABQAAAAAAAAAwMD/AAAAAABkAAAAMgAAAAAAAABkAAAAAAAAAH9/fwAKAAAAIgAAABgAAAAAAAAAAAAAAAAAAAAAAAAAAAAAAAAAAAAkAAAAJAAAAAAAAAAHAAAAAAAAAAAAAAAAAAAAAAAAAAAAAAAAAAAAf39/ACUAAABYAAAAAAAAAAAAAAAAAAAAAAAAAAAAAAAAAAAAAAAAAAAAAAAAAAAAAAAAAAAAAAA/AAAAAAAAAKCGAQAAAAAAAAAAAAAAAAAMAAAAAQAAAAAAAAAAAAAAAAAAAB8AAABUAAAAAAAABQAAAAEAAAAAAAAAAAAAAAAAAAAAAAAAAAAAAAAAAAAAAAAAAAAAAAJ/f38AAAAAA8zMzADAwP8Af39/AAAAAAAAAAAAAAAAAAAAAAAAAAAAIQAAABgAAAAUAAAAFAMAALYCAAB/NwAAvwoAABAAAAAmAAAACAAAADywAAAAAAAA"/>
               </a:ext>
             </a:extLst>
           </p:cNvSpPr>
@@ -2778,7 +2654,7 @@
           <p:cNvSpPr>
             <a:extLst>
               <a:ext uri="smNativeData">
-                <pr:smNativeData xmlns:pr="smNativeData" xmlns="smNativeData" val="SMDATA_15_EkJ5ZhMAAAAlAAAAZAAAAA0AAAAAkAAAAJAAAACQAAAAkAAAAAAAAAABAAAAAAAAAAEAAABQAAAAAAAAAAAA4D8AAAAAAADgPwAAAAAAAOA/AAAAAAAA4D8AAAAAAADgPwAAAAAAAOA/AAAAAAAA4D8AAAAAAADgPwAAAAAAAOA/AAAAAAAA4D8CAAAAjAAAAAEAAAAAAAAA+/v+AP///wgAAAAAAAAAAAAAAAAAAAAAAAAAAAAAAAAAAAAAeAAAAAEAAABAAAAAAAAAAAAAAABaAAAAAAAAAAAAAAAAAAAAAAAAAAAAAAAAAAAAAAAAAAAAAAAAAAAAAAAAAAAAAAAAAAAAAAAAAAAAAAAAAAAAAAAAAAAAAAAAAAAAFAAAADwAAAAAAAAAAAAAAAAAAAkUAAAAAQAAABQAAAAUAAAAFAAAAAEAAAAAAAAAZAAAAGQAAAAAAAAAZAAAAGQAAAAVAAAAYAAAAAAAAAAAAAAADwAAACADAAAAAAAAAAAAAAEAAACgMgAAVgcAAKr4//8BAAAAf39/AAEAAABkAAAAAAAAABQAAABAHwAAAAAAACYAAAAAAAAAwOD//wAAAAAmAAAAZAAAABYAAABMAAAAAAAAAAAAAAAEAAAAAAAAAAEAAABZWVkKAAAAACgAAAAoAAAAZAAAAGQAAAAAAAAAzMzMAAAAAABQAAAAUAAAAGQAAABkAAAAAAAAABcAAAAUAAAAAAAAAAAAAAD/fwAA/38AAAAAAAAJAAAABAAAAAAAAAAeAAAAaAAAAAAAAAAAAAAAAAAAAAAAAAAAAAAAECcAABAnAAAAAAAAAAAAAAAAAAAAAAAAAAAAAAAAAAAAAAAAAAAAABQAAAAAAAAAwMD/AAAAAABkAAAAMgAAAAAAAABkAAAAAAAAAH9/fwAKAAAAIgAAABgAAAAAAAAAAAAAAAAAAAAAAAAAAAAAAAAAAAAkAAAAJAAAAAAAAAAHAAAAAAAAAAAAAAAAAAAAAAAAAAAAAAAAAAAAf39/ACUAAABYAAAAAAAAAAAAAAAAAAAAAAAAAAAAAAAAAAAAAAAAAAAAAAAAAAAAAAAAAAAAAAA/AAAAAAAAAKCGAQAAAAAAAAAAAAAAAAAMAAAAAQAAAAAAAAAAAAAAAAAAAB8AAABUAAAA+/v+AP///wEAAAAAAAAAAAAAAAAAAAAAAAAAAAAAAAAAAAAAAAAAAAAAAAJ/f38AWVlZA8zMzADAwP8Af39/AAAAAAAAAAAAAAAAAAAAAAAAAAAAIQAAABgAAAAUAAAAuwMAAPIJAACQNAAALycAABAAAAAmAAAACAAAAP//////////"/>
+                <pr:smNativeData xmlns:pr="smNativeData" xmlns="smNativeData" val="SMDATA_15_LkR5ZhMAAAAlAAAAZAAAAA0AAAAAkAAAAJAAAACQAAAAkAAAAAAAAAABAAAAAAAAAAEAAABQAAAAAAAAAAAA4D8AAAAAAADgPwAAAAAAAOA/AAAAAAAA4D8AAAAAAADgPwAAAAAAAOA/AAAAAAAA4D8AAAAAAADgPwAAAAAAAOA/AAAAAAAA4D8CAAAAjAAAAAEAAAAAAAAA+/v+AP///wgAAAAAAAAAAAAAAAAAAAAAAAAAAAAAAAAAAAAAeAAAAAEAAABAAAAAAAAAAAAAAABaAAAAAAAAAAAAAAAAAAAAAAAAAAAAAAAAAAAAAAAAAAAAAAAAAAAAAAAAAAAAAAAAAAAAAAAAAAAAAAAAAAAAAAAAAAAAAAAAAAAAFAAAADwAAAAAAAAAAAAAAAAAAAkUAAAAAQAAABQAAAAUAAAAFAAAAAEAAAAAAAAAZAAAAGQAAAAAAAAAZAAAAGQAAAAVAAAAYAAAAAAAAAAAAAAADwAAACADAAAAAAAAAAAAAAEAAACgMgAAVgcAAKr4//8BAAAAf39/AAEAAABkAAAAAAAAABQAAABAHwAAAAAAACYAAAAAAAAAwOD//wAAAAAmAAAAZAAAABYAAABMAAAAAAAAAAAAAAAEAAAAAAAAAAEAAABZWVkKAAAAACgAAAAoAAAAZAAAAGQAAAAAAAAAzMzMAAAAAABQAAAAUAAAAGQAAABkAAAAAAAAABcAAAAUAAAAAAAAAAAAAAD/fwAA/38AAAAAAAAJAAAABAAAAAAAAAAeAAAAaAAAAAAAAAAAAAAAAAAAAAAAAAAAAAAAECcAABAnAAAAAAAAAAAAAAAAAAAAAAAAAAAAAAAAAAAAAAAAAAAAABQAAAAAAAAAwMD/AAAAAABkAAAAMgAAAAAAAABkAAAAAAAAAH9/fwAKAAAAIgAAABgAAAAAAAAAAAAAAAAAAAAAAAAAAAAAAAAAAAAkAAAAJAAAAAAAAAAHAAAAAAAAAAAAAAAAAAAAAAAAAAAAAAAAAAAAf39/ACUAAABYAAAAAAAAAAAAAAAAAAAAAAAAAAAAAAAAAAAAAAAAAAAAAAAAAAAAAAAAAAAAAAA/AAAAAAAAAKCGAQAAAAAAAAAAAAAAAAAMAAAAAQAAAAAAAAAAAAAAAAAAAB8AAABUAAAA+/v+AP///wEAAAAAAAAAAAAAAAAAAAAAAAAAAAAAAAAAAAAAAAAAAAAAAAJ/f38AWVlZA8zMzADAwP8Af39/AAAAAAAAAAAAAAAAAAAAAAAAAAAAIQAAABgAAAAUAAAAuwMAAPIJAACQNAAALycAABAAAAAmAAAACAAAAP//////////"/>
               </a:ext>
             </a:extLst>
           </p:cNvSpPr>
@@ -2823,7 +2699,7 @@
             <a:spLocks noGrp="1" noChangeArrowheads="1"/>
             <a:extLst>
               <a:ext uri="smNativeData">
-                <pr:smNativeData xmlns:pr="smNativeData" xmlns="smNativeData" val="SMDATA_15_EkJ5ZhMAAAAlAAAAZAAAAA0AAAAAkAAAAJAAAACQAAAAkAAAAAAAAAAAAAAAAAAAAAEAAABQAAAAAAAAAAAA4D8AAAAAAADgPwAAAAAAAOA/AAAAAAAA4D8AAAAAAADgPwAAAAAAAOA/AAAAAAAA4D8AAAAAAADgPwAAAAAAAOA/AAAAAAAA4D8CAAAAjAAAAAAAAAAAAAAAQoX0DP///wgAAAAAAAAAAAAAAAAAAAAAAAAAAAAAAAAAAAAAZAAAAAEAAABAAAAAAAAAAAAAAAAAAAAAAAAAAAAAAAAAAAAAAAAAAAAAAAAAAAAAAAAAAAAAAAAAAAAAAAAAAAAAAAAAAAAAAAAAAAAAAAAAAAAAAAAAAAAAAAAAAAAAFAAAADwAAAAAAAAAAAAAAAAAAAkUAAAAAQAAABQAAAAUAAAAFAAAAAEAAAAAAAAAZAAAAGQAAAAAAAAAZAAAAGQAAAAVAAAAYAAAAAAAAAAAAAAADwAAACADAAAAAAAAAAAAAAEAAACgMgAAVgcAAKr4//8BAAAAf39/AAEAAABkAAAAAAAAABQAAABAHwAAAAAAACYAAAAAAAAAwOD//wAAAAAmAAAAZAAAABYAAABMAAAAAAAAAAAAAAAEAAAAAAAAAAEAAABZWVkKAAAAACgAAAAoAAAAZAAAAGQAAAAAAAAAzMzMAAAAAABQAAAAUAAAAGQAAABkAAAAAAAAABcAAAAUAAAAAAAAAAAAAAD/fwAA/38AAAAAAAAJAAAABAAAAAAAAAAeAAAAaAAAAAAAAAAAAAAAAAAAAAAAAAAAAAAAECcAABAnAAAAAAAAAAAAAAAAAAAAAAAAAAAAAAAAAAAAAAAAAAAAABQAAAAAAAAAwMD/AAAAAABkAAAAMgAAAAAAAABkAAAAAAAAAH9/fwAKAAAAIgAAABgAAAAAAAAAAAAAAAAAAAAAAAAAAAAAAAAAAAAkAAAAJAAAAAAAAAAHAAAAAAAAAAAAAAAAAAAAAAAAAAAAAAAAAAAAf39/ACUAAABYAAAAAAAAAAAAAAAAAAAAAAAAAAAAAAAAAAAAAAAAAAAAAAAAAAAAAAAAAAAAAAA/AAAAAAAAAKCGAQAAAAAAAAAAAAAAAAAMAAAAAQAAAAAAAAAAAAAAAAAAAB8AAABUAAAAAAAABQAAAAEAAAAAAAAAAAAAAAAAAAAAAAAAAAAAAAAAAAAAAAAAAAAAAAJ/f38AAAAAA8zMzADAwP8Af39/AAAAAAAAAAAAAAAAAAAAAAAAAAAAIQAAABgAAAAUAAAAfAQAANkKAAC5NQAAMCcAABAAAAAmAAAACAAAAD2wAAAAAAAA"/>
+                <pr:smNativeData xmlns:pr="smNativeData" xmlns="smNativeData" val="SMDATA_15_LkR5ZhMAAAAlAAAAZAAAAA0AAAAAkAAAAJAAAACQAAAAkAAAAAAAAAAAAAAAAAAAAAEAAABQAAAAAAAAAAAA4D8AAAAAAADgPwAAAAAAAOA/AAAAAAAA4D8AAAAAAADgPwAAAAAAAOA/AAAAAAAA4D8AAAAAAADgPwAAAAAAAOA/AAAAAAAA4D8CAAAAjAAAAAAAAAAAAAAAQoX0DP///wgAAAAAAAAAAAAAAAAAAAAAAAAAAAAAAAAAAAAAZAAAAAEAAABAAAAAAAAAAAAAAAAAAAAAAAAAAAAAAAAAAAAAAAAAAAAAAAAAAAAAAAAAAAAAAAAAAAAAAAAAAAAAAAAAAAAAAAAAAAAAAAAAAAAAAAAAAAAAAAAAAAAAFAAAADwAAAAAAAAAAAAAAAAAAAkUAAAAAQAAABQAAAAUAAAAFAAAAAEAAAAAAAAAZAAAAGQAAAAAAAAAZAAAAGQAAAAVAAAAYAAAAAAAAAAAAAAADwAAACADAAAAAAAAAAAAAAEAAACgMgAAVgcAAKr4//8BAAAAf39/AAEAAABkAAAAAAAAABQAAABAHwAAAAAAACYAAAAAAAAAwOD//wAAAAAmAAAAZAAAABYAAABMAAAAAAAAAAAAAAAEAAAAAAAAAAEAAABZWVkKAAAAACgAAAAoAAAAZAAAAGQAAAAAAAAAzMzMAAAAAABQAAAAUAAAAGQAAABkAAAAAAAAABcAAAAUAAAAAAAAAAAAAAD/fwAA/38AAAAAAAAJAAAABAAAAAAAAAAeAAAAaAAAAAAAAAAAAAAAAAAAAAAAAAAAAAAAECcAABAnAAAAAAAAAAAAAAAAAAAAAAAAAAAAAAAAAAAAAAAAAAAAABQAAAAAAAAAwMD/AAAAAABkAAAAMgAAAAAAAABkAAAAAAAAAH9/fwAKAAAAIgAAABgAAAAAAAAAAAAAAAAAAAAAAAAAAAAAAAAAAAAkAAAAJAAAAAAAAAAHAAAAAAAAAAAAAAAAAAAAAAAAAAAAAAAAAAAAf39/ACUAAABYAAAAAAAAAAAAAAAAAAAAAAAAAAAAAAAAAAAAAAAAAAAAAAAAAAAAAAAAAAAAAAA/AAAAAAAAAKCGAQAAAAAAAAAAAAAAAAAMAAAAAQAAAAAAAAAAAAAAAAAAAB8AAABUAAAAAAAABQAAAAEAAAAAAAAAAAAAAAAAAAAAAAAAAAAAAAAAAAAAAAAAAAAAAAJ/f38AAAAAA8zMzADAwP8Af39/AAAAAAAAAAAAAAAAAAAAAAAAAAAAIQAAABgAAAAUAAAAfAQAANkKAAC5NQAAMCcAABAAAAAmAAAACAAAAD2wAAAAAAAA"/>
               </a:ext>
             </a:extLst>
           </p:cNvSpPr>
@@ -3003,7 +2879,7 @@
             <a:spLocks noGrp="1" noChangeArrowheads="1"/>
             <a:extLst>
               <a:ext uri="smNativeData">
-                <pr:smNativeData xmlns:pr="smNativeData" xmlns="smNativeData" val="SMDATA_15_EkJ5ZhMAAAAlAAAAZAAAAA0AAAAAkAAAAJAAAACQAAAAkAAAAAAAAAAAAAAAAAAAAAEAAABQAAAAAAAAAAAA4D8AAAAAAADgPwAAAAAAAOA/AAAAAAAA4D8AAAAAAADgPwAAAAAAAOA/AAAAAAAA4D8AAAAAAADgPwAAAAAAAOA/AAAAAAAA4D8CAAAAjAAAAAAAAAAAAAAAQoX0DP///wgAAAAAAAAAAAAAAAAAAAAAAAAAAAAAAAAAAAAAZAAAAAEAAABAAAAAAAAAAAAAAAAAAAAAAAAAAAAAAAAAAAAAAAAAAAAAAAAAAAAAAAAAAAAAAAAAAAAAAAAAAAAAAAAAAAAAAAAAAAAAAAAAAAAAAAAAAAAAAAAAAAAAFAAAADwAAAAAAAAAAAAAAAAAAAkUAAAAAQAAABQAAAAUAAAAFAAAAAEAAAAAAAAAZAAAAGQAAAAAAAAAZAAAAGQAAAAVAAAAYAAAAAAAAAAAAAAADwAAACADAAAAAAAAAAAAAAEAAACgMgAAVgcAAKr4//8BAAAAf39/AAEAAABkAAAAAAAAABQAAABAHwAAAAAAACYAAAAAAAAAwOD//wAAAAAmAAAAZAAAABYAAABMAAAAAAAAAAAAAAAEAAAAAAAAAAEAAABZWVkKAAAAACgAAAAoAAAAZAAAAGQAAAAAAAAAzMzMAAAAAABQAAAAUAAAAGQAAABkAAAAAAAAABcAAAAUAAAAAAAAAAAAAAD/fwAA/38AAAAAAAAJAAAABAAAAAAAAAAeAAAAaAAAAAAAAAAAAAAAAAAAAAAAAAAAAAAAECcAABAnAAAAAAAAAAAAAAAAAAAAAAAAAAAAAAAAAAAAAAAAAAAAABQAAAAAAAAAwMD/AAAAAABkAAAAMgAAAAAAAABkAAAAAAAAAH9/fwAKAAAAIgAAABgAAAAAAAAAAAAAAAAAAAAAAAAAAAAAAAAAAAAkAAAAJAAAAAAAAAAHAAAAAAAAAAAAAAAAAAAAAAAAAAAAAAAAAAAAf39/ACUAAABYAAAAAAAAAAAAAAAAAAAAAAAAAAAAAAAAAAAAAAAAAAAAAAAAAAAAAAAAAAAAAAA/AAAAAAAAAKCGAQAAAAAAAAAAAAAAAAAMAAAAAQAAAAAAAAAAAAAAAAAAAB8AAABUAAAAAAAABQAAAAEAAAAAAAAAAAAAAAAAAAAAAAAAAAAAAAAAAAAAAAAAAAAAAAJ/f38AAAAAA8zMzADAwP8Af39/AAAAAAAAAAAAAAAAAAAAAAAAAAAAIQAAABgAAAAUAAAAFAMAALYCAAB/NwAAvwoAABAAAAAmAAAACAAAADywAAAAAAAA"/>
+                <pr:smNativeData xmlns:pr="smNativeData" xmlns="smNativeData" val="SMDATA_15_LkR5ZhMAAAAlAAAAZAAAAA0AAAAAkAAAAJAAAACQAAAAkAAAAAAAAAAAAAAAAAAAAAEAAABQAAAAAAAAAAAA4D8AAAAAAADgPwAAAAAAAOA/AAAAAAAA4D8AAAAAAADgPwAAAAAAAOA/AAAAAAAA4D8AAAAAAADgPwAAAAAAAOA/AAAAAAAA4D8CAAAAjAAAAAAAAAAAAAAAQoX0DP///wgAAAAAAAAAAAAAAAAAAAAAAAAAAAAAAAAAAAAAZAAAAAEAAABAAAAAAAAAAAAAAAAAAAAAAAAAAAAAAAAAAAAAAAAAAAAAAAAAAAAAAAAAAAAAAAAAAAAAAAAAAAAAAAAAAAAAAAAAAAAAAAAAAAAAAAAAAAAAAAAAAAAAFAAAADwAAAAAAAAAAAAAAAAAAAkUAAAAAQAAABQAAAAUAAAAFAAAAAEAAAAAAAAAZAAAAGQAAAAAAAAAZAAAAGQAAAAVAAAAYAAAAAAAAAAAAAAADwAAACADAAAAAAAAAAAAAAEAAACgMgAAVgcAAKr4//8BAAAAf39/AAEAAABkAAAAAAAAABQAAABAHwAAAAAAACYAAAAAAAAAwOD//wAAAAAmAAAAZAAAABYAAABMAAAAAAAAAAAAAAAEAAAAAAAAAAEAAABZWVkKAAAAACgAAAAoAAAAZAAAAGQAAAAAAAAAzMzMAAAAAABQAAAAUAAAAGQAAABkAAAAAAAAABcAAAAUAAAAAAAAAAAAAAD/fwAA/38AAAAAAAAJAAAABAAAAAAAAAAeAAAAaAAAAAAAAAAAAAAAAAAAAAAAAAAAAAAAECcAABAnAAAAAAAAAAAAAAAAAAAAAAAAAAAAAAAAAAAAAAAAAAAAABQAAAAAAAAAwMD/AAAAAABkAAAAMgAAAAAAAABkAAAAAAAAAH9/fwAKAAAAIgAAABgAAAAAAAAAAAAAAAAAAAAAAAAAAAAAAAAAAAAkAAAAJAAAAAAAAAAHAAAAAAAAAAAAAAAAAAAAAAAAAAAAAAAAAAAAf39/ACUAAABYAAAAAAAAAAAAAAAAAAAAAAAAAAAAAAAAAAAAAAAAAAAAAAAAAAAAAAAAAAAAAAA/AAAAAAAAAKCGAQAAAAAAAAAAAAAAAAAMAAAAAQAAAAAAAAAAAAAAAAAAAB8AAABUAAAAAAAABQAAAAEAAAAAAAAAAAAAAAAAAAAAAAAAAAAAAAAAAAAAAAAAAAAAAAJ/f38AAAAAA8zMzADAwP8Af39/AAAAAAAAAAAAAAAAAAAAAAAAAAAAIQAAABgAAAAUAAAAFAMAALYCAAB/NwAAvwoAABAAAAAmAAAACAAAADywAAAAAAAA"/>
               </a:ext>
             </a:extLst>
           </p:cNvSpPr>
@@ -3112,7 +2988,7 @@
           <p:cNvSpPr>
             <a:extLst>
               <a:ext uri="smNativeData">
-                <pr:smNativeData xmlns:pr="smNativeData" xmlns="smNativeData" val="SMDATA_15_EkJ5ZhMAAAAlAAAAZAAAAA0AAAAAkAAAAJAAAACQAAAAkAAAAAAAAAABAAAAAAAAAAEAAABQAAAAAAAAAAAA4D8AAAAAAADgPwAAAAAAAOA/AAAAAAAA4D8AAAAAAADgPwAAAAAAAOA/AAAAAAAA4D8AAAAAAADgPwAAAAAAAOA/AAAAAAAA4D8CAAAAjAAAAAEAAAAAAAAAISEhDf///wgAAAAAAAAAAAAAAAAAAAAAAAAAAAAAAAAAAAAAeAAAAAEAAABAAAAAAAAAAAAAAABaAAAAAAAAAAAAAAAAAAAAAAAAAAAAAAAAAAAAAAAAAAAAAAAAAAAAAAAAAAAAAAAAAAAAAAAAAAAAAAAAAAAAAAAAAAAAAAAAAAAAFAAAADwAAAAAAAAAAAAAAAAAAAkUAAAAAQAAABQAAAAUAAAAFAAAAAEAAAAAAAAAZAAAAGQAAAAAAAAAZAAAAGQAAAAVAAAAYAAAAAAAAAAAAAAADwAAACADAAAAAAAAAAAAAAEAAACgMgAAVgcAAKr4//8BAAAAf39/AAEAAABkAAAAAAAAABQAAABAHwAAAAAAACYAAAAAAAAAwOD//wAAAAAmAAAAZAAAABYAAABMAAAAAAAAAAAAAAAEAAAAAAAAAAEAAABZWVkKAAAAACgAAAAoAAAAZAAAAGQAAAAAAAAAzMzMAAAAAABQAAAAUAAAAGQAAABkAAAAAAAAABcAAAAUAAAAAAAAAAAAAAD/fwAA/38AAAAAAAAJAAAABAAAAAAAAAAeAAAAaAAAAAAAAAAAAAAAAAAAAAAAAAAAAAAAECcAABAnAAAAAAAAAAAAAAAAAAAAAAAAAAAAAAAAAAAAAAAAAAAAABQAAAAAAAAAwMD/AAAAAABkAAAAMgAAAAAAAABkAAAAAAAAAH9/fwAKAAAAIgAAABgAAAAAAAAAAAAAAAAAAAAAAAAAAAAAAAAAAAAkAAAAJAAAAAAAAAAHAAAAAAAAAAAAAAAAAAAAAAAAAAAAAAAAAAAAf39/ACUAAABYAAAAAAAAAAAAAAAAAAAAAAAAAAAAAAAAAAAAAAAAAAAAAAAAAAAAAAAAAAAAAAA/AAAAAAAAAKCGAQAAAAAAAAAAAAAAAAAMAAAAAQAAAAAAAAAAAAAAAAAAAB8AAABUAAAAAAAABgAAAAEAAAAAAAAAAAAAAAAAAAAAAAAAAAAAAAAAAAAAAAAAAAAAAAJ/f38AAAAAA8zMzADAwP8Af39/AAAAAAAAAAAAAAAAAAAAAAAAAAAAIQAAABgAAAAUAAAAuwMAAPIJAACQNAAALycAABAAAAAmAAAACAAAAP//////////"/>
+                <pr:smNativeData xmlns:pr="smNativeData" xmlns="smNativeData" val="SMDATA_15_LkR5ZhMAAAAlAAAAZAAAAA0AAAAAkAAAAJAAAACQAAAAkAAAAAAAAAABAAAAAAAAAAEAAABQAAAAAAAAAAAA4D8AAAAAAADgPwAAAAAAAOA/AAAAAAAA4D8AAAAAAADgPwAAAAAAAOA/AAAAAAAA4D8AAAAAAADgPwAAAAAAAOA/AAAAAAAA4D8CAAAAjAAAAAEAAAAAAAAAISEhDf///wgAAAAAAAAAAAAAAAAAAAAAAAAAAAAAAAAAAAAAeAAAAAEAAABAAAAAAAAAAAAAAABaAAAAAAAAAAAAAAAAAAAAAAAAAAAAAAAAAAAAAAAAAAAAAAAAAAAAAAAAAAAAAAAAAAAAAAAAAAAAAAAAAAAAAAAAAAAAAAAAAAAAFAAAADwAAAAAAAAAAAAAAAAAAAkUAAAAAQAAABQAAAAUAAAAFAAAAAEAAAAAAAAAZAAAAGQAAAAAAAAAZAAAAGQAAAAVAAAAYAAAAAAAAAAAAAAADwAAACADAAAAAAAAAAAAAAEAAACgMgAAVgcAAKr4//8BAAAAf39/AAEAAABkAAAAAAAAABQAAABAHwAAAAAAACYAAAAAAAAAwOD//wAAAAAmAAAAZAAAABYAAABMAAAAAAAAAAAAAAAEAAAAAAAAAAEAAABZWVkKAAAAACgAAAAoAAAAZAAAAGQAAAAAAAAAzMzMAAAAAABQAAAAUAAAAGQAAABkAAAAAAAAABcAAAAUAAAAAAAAAAAAAAD/fwAA/38AAAAAAAAJAAAABAAAAAAAAAAeAAAAaAAAAAAAAAAAAAAAAAAAAAAAAAAAAAAAECcAABAnAAAAAAAAAAAAAAAAAAAAAAAAAAAAAAAAAAAAAAAAAAAAABQAAAAAAAAAwMD/AAAAAABkAAAAMgAAAAAAAABkAAAAAAAAAH9/fwAKAAAAIgAAABgAAAAAAAAAAAAAAAAAAAAAAAAAAAAAAAAAAAAkAAAAJAAAAAAAAAAHAAAAAAAAAAAAAAAAAAAAAAAAAAAAAAAAAAAAf39/ACUAAABYAAAAAAAAAAAAAAAAAAAAAAAAAAAAAAAAAAAAAAAAAAAAAAAAAAAAAAAAAAAAAAA/AAAAAAAAAKCGAQAAAAAAAAAAAAAAAAAMAAAAAQAAAAAAAAAAAAAAAAAAAB8AAABUAAAAAAAABgAAAAEAAAAAAAAAAAAAAAAAAAAAAAAAAAAAAAAAAAAAAAAAAAAAAAJ/f38AAAAAA8zMzADAwP8Af39/AAAAAAAAAAAAAAAAAAAAAAAAAAAAIQAAABgAAAAUAAAAuwMAAPIJAACQNAAALycAABAAAAAmAAAACAAAAP//////////"/>
               </a:ext>
             </a:extLst>
           </p:cNvSpPr>
@@ -3157,7 +3033,7 @@
             <a:spLocks noGrp="1" noChangeArrowheads="1"/>
             <a:extLst>
               <a:ext uri="smNativeData">
-                <pr:smNativeData xmlns:pr="smNativeData" xmlns="smNativeData" val="SMDATA_15_EkJ5ZhMAAAAlAAAAZAAAAA0AAAAAkAAAAJAAAACQAAAAkAAAAAAAAAAAAAAAAAAAAAEAAABQAAAAAAAAAAAA4D8AAAAAAADgPwAAAAAAAOA/AAAAAAAA4D8AAAAAAADgPwAAAAAAAOA/AAAAAAAA4D8AAAAAAADgPwAAAAAAAOA/AAAAAAAA4D8CAAAAjAAAAAAAAAAAAAAAQoX0DP///wgAAAAAAAAAAAAAAAAAAAAAAAAAAAAAAAAAAAAAZAAAAAEAAABAAAAAAAAAAAAAAAAAAAAAAAAAAAAAAAAAAAAAAAAAAAAAAAAAAAAAAAAAAAAAAAAAAAAAAAAAAAAAAAAAAAAAAAAAAAAAAAAAAAAAAAAAAAAAAAAAAAAAFAAAADwAAAAAAAAAAAAAAAAAAAkUAAAAAQAAABQAAAAUAAAAFAAAAAEAAAAAAAAAZAAAAGQAAAAAAAAAZAAAAGQAAAAVAAAAYAAAAAAAAAAAAAAADwAAACADAAAAAAAAAAAAAAEAAACgMgAAVgcAAKr4//8BAAAAf39/AAEAAABkAAAAAAAAABQAAABAHwAAAAAAACYAAAAAAAAAwOD//wAAAAAmAAAAZAAAABYAAABMAAAAAAAAAAAAAAAEAAAAAAAAAAEAAABZWVkKAAAAACgAAAAoAAAAZAAAAGQAAAAAAAAAzMzMAAAAAABQAAAAUAAAAGQAAABkAAAAAAAAABcAAAAUAAAAAAAAAAAAAAD/fwAA/38AAAAAAAAJAAAABAAAAAAAAAAeAAAAaAAAAAAAAAAAAAAAAAAAAAAAAAAAAAAAECcAABAnAAAAAAAAAAAAAAAAAAAAAAAAAAAAAAAAAAAAAAAAAAAAABQAAAAAAAAAwMD/AAAAAABkAAAAMgAAAAAAAABkAAAAAAAAAH9/fwAKAAAAIgAAABgAAAAAAAAAAAAAAAAAAAAAAAAAAAAAAAAAAAAkAAAAJAAAAAAAAAAHAAAAAAAAAAAAAAAAAAAAAAAAAAAAAAAAAAAAf39/ACUAAABYAAAAAAAAAAAAAAAAAAAAAAAAAAAAAAAAAAAAAAAAAAAAAAAAAAAAAAAAAAAAAAA/AAAAAAAAAKCGAQAAAAAAAAAAAAAAAAAMAAAAAQAAAAAAAAAAAAAAAAAAAB8AAABUAAAAAAAABQAAAAEAAAAAAAAAAAAAAAAAAAAAAAAAAAAAAAAAAAAAAAAAAAAAAAJ/f38AAAAAA8zMzADAwP8Af39/AAAAAAAAAAAAAAAAAAAAAAAAAAAAIQAAABgAAAAUAAAAfAQAANkKAAC5NQAAMCcAABAAAAAmAAAACAAAAD2wAAAAAAAA"/>
+                <pr:smNativeData xmlns:pr="smNativeData" xmlns="smNativeData" val="SMDATA_15_LkR5ZhMAAAAlAAAAZAAAAA0AAAAAkAAAAJAAAACQAAAAkAAAAAAAAAAAAAAAAAAAAAEAAABQAAAAAAAAAAAA4D8AAAAAAADgPwAAAAAAAOA/AAAAAAAA4D8AAAAAAADgPwAAAAAAAOA/AAAAAAAA4D8AAAAAAADgPwAAAAAAAOA/AAAAAAAA4D8CAAAAjAAAAAAAAAAAAAAAQoX0DP///wgAAAAAAAAAAAAAAAAAAAAAAAAAAAAAAAAAAAAAZAAAAAEAAABAAAAAAAAAAAAAAAAAAAAAAAAAAAAAAAAAAAAAAAAAAAAAAAAAAAAAAAAAAAAAAAAAAAAAAAAAAAAAAAAAAAAAAAAAAAAAAAAAAAAAAAAAAAAAAAAAAAAAFAAAADwAAAAAAAAAAAAAAAAAAAkUAAAAAQAAABQAAAAUAAAAFAAAAAEAAAAAAAAAZAAAAGQAAAAAAAAAZAAAAGQAAAAVAAAAYAAAAAAAAAAAAAAADwAAACADAAAAAAAAAAAAAAEAAACgMgAAVgcAAKr4//8BAAAAf39/AAEAAABkAAAAAAAAABQAAABAHwAAAAAAACYAAAAAAAAAwOD//wAAAAAmAAAAZAAAABYAAABMAAAAAAAAAAAAAAAEAAAAAAAAAAEAAABZWVkKAAAAACgAAAAoAAAAZAAAAGQAAAAAAAAAzMzMAAAAAABQAAAAUAAAAGQAAABkAAAAAAAAABcAAAAUAAAAAAAAAAAAAAD/fwAA/38AAAAAAAAJAAAABAAAAAAAAAAeAAAAaAAAAAAAAAAAAAAAAAAAAAAAAAAAAAAAECcAABAnAAAAAAAAAAAAAAAAAAAAAAAAAAAAAAAAAAAAAAAAAAAAABQAAAAAAAAAwMD/AAAAAABkAAAAMgAAAAAAAABkAAAAAAAAAH9/fwAKAAAAIgAAABgAAAAAAAAAAAAAAAAAAAAAAAAAAAAAAAAAAAAkAAAAJAAAAAAAAAAHAAAAAAAAAAAAAAAAAAAAAAAAAAAAAAAAAAAAf39/ACUAAABYAAAAAAAAAAAAAAAAAAAAAAAAAAAAAAAAAAAAAAAAAAAAAAAAAAAAAAAAAAAAAAA/AAAAAAAAAKCGAQAAAAAAAAAAAAAAAAAMAAAAAQAAAAAAAAAAAAAAAAAAAB8AAABUAAAAAAAABQAAAAEAAAAAAAAAAAAAAAAAAAAAAAAAAAAAAAAAAAAAAAAAAAAAAAJ/f38AAAAAA8zMzADAwP8Af39/AAAAAAAAAAAAAAAAAAAAAAAAAAAAIQAAABgAAAAUAAAAfAQAANkKAAC5NQAAMCcAABAAAAAmAAAACAAAAD2wAAAAAAAA"/>
               </a:ext>
             </a:extLst>
           </p:cNvSpPr>
@@ -3372,7 +3248,7 @@
             <a:spLocks noGrp="1" noChangeArrowheads="1"/>
             <a:extLst>
               <a:ext uri="smNativeData">
-                <pr:smNativeData xmlns:pr="smNativeData" xmlns="smNativeData" val="SMDATA_15_EkJ5ZhMAAAAlAAAAZAAAAA0AAAAAkAAAAJAAAACQAAAAkAAAAAAAAAAAAAAAAAAAAAEAAABQAAAAAAAAAAAA4D8AAAAAAADgPwAAAAAAAOA/AAAAAAAA4D8AAAAAAADgPwAAAAAAAOA/AAAAAAAA4D8AAAAAAADgPwAAAAAAAOA/AAAAAAAA4D8CAAAAjAAAAAAAAAAAAAAAQoX0DP///wgAAAAAAAAAAAAAAAAAAAAAAAAAAAAAAAAAAAAAZAAAAAEAAABAAAAAAAAAAAAAAAAAAAAAAAAAAAAAAAAAAAAAAAAAAAAAAAAAAAAAAAAAAAAAAAAAAAAAAAAAAAAAAAAAAAAAAAAAAAAAAAAAAAAAAAAAAAAAAAAAAAAAFAAAADwAAAAAAAAAAAAAAAAAAAkUAAAAAQAAABQAAAAUAAAAFAAAAAEAAAAAAAAAZAAAAGQAAAAAAAAAZAAAAGQAAAAVAAAAYAAAAAAAAAAAAAAADwAAACADAAAAAAAAAAAAAAEAAACgMgAAVgcAAKr4//8BAAAAf39/AAEAAABkAAAAAAAAABQAAABAHwAAAAAAACYAAAAAAAAAwOD//wAAAAAmAAAAZAAAABYAAABMAAAAAAAAAAAAAAAEAAAAAAAAAAEAAABZWVkKAAAAACgAAAAoAAAAZAAAAGQAAAAAAAAAzMzMAAAAAABQAAAAUAAAAGQAAABkAAAAAAAAABcAAAAUAAAAAAAAAAAAAAD/fwAA/38AAAAAAAAJAAAABAAAAAAAAAAeAAAAaAAAAAAAAAAAAAAAAAAAAAAAAAAAAAAAECcAABAnAAAAAAAAAAAAAAAAAAAAAAAAAAAAAAAAAAAAAAAAAAAAABQAAAAAAAAAwMD/AAAAAABkAAAAMgAAAAAAAABkAAAAAAAAAH9/fwAKAAAAIgAAABgAAAAAAAAAAAAAAAAAAAAAAAAAAAAAAAAAAAAkAAAAJAAAAAAAAAAHAAAAAAAAAAAAAAAAAAAAAAAAAAAAAAAAAAAAf39/ACUAAABYAAAAAAAAAAAAAAAAAAAAAAAAAAAAAAAAAAAAAAAAAAAAAAAAAAAAAAAAAAAAAAA/AAAAAAAAAKCGAQAAAAAAAAAAAAAAAAAMAAAAAQAAAAAAAAAAAAAAAAAAAB8AAABUAAAAAAAABQAAAAEAAAAAAAAAAAAAAAAAAAAAAAAAAAAAAAAAAAAAAAAAAAAAAAJ/f38AAAAAA8zMzADAwP8Af39/AAAAAAAAAAAAAAAAAAAAAAAAAAAAIQAAABgAAAAUAAAAFAMAALYCAAB/NwAAvwoAABAAAAAmAAAACAAAADywAAAAAAAA"/>
+                <pr:smNativeData xmlns:pr="smNativeData" xmlns="smNativeData" val="SMDATA_15_LkR5ZhMAAAAlAAAAZAAAAA0AAAAAkAAAAJAAAACQAAAAkAAAAAAAAAAAAAAAAAAAAAEAAABQAAAAAAAAAAAA4D8AAAAAAADgPwAAAAAAAOA/AAAAAAAA4D8AAAAAAADgPwAAAAAAAOA/AAAAAAAA4D8AAAAAAADgPwAAAAAAAOA/AAAAAAAA4D8CAAAAjAAAAAAAAAAAAAAAQoX0DP///wgAAAAAAAAAAAAAAAAAAAAAAAAAAAAAAAAAAAAAZAAAAAEAAABAAAAAAAAAAAAAAAAAAAAAAAAAAAAAAAAAAAAAAAAAAAAAAAAAAAAAAAAAAAAAAAAAAAAAAAAAAAAAAAAAAAAAAAAAAAAAAAAAAAAAAAAAAAAAAAAAAAAAFAAAADwAAAAAAAAAAAAAAAAAAAkUAAAAAQAAABQAAAAUAAAAFAAAAAEAAAAAAAAAZAAAAGQAAAAAAAAAZAAAAGQAAAAVAAAAYAAAAAAAAAAAAAAADwAAACADAAAAAAAAAAAAAAEAAACgMgAAVgcAAKr4//8BAAAAf39/AAEAAABkAAAAAAAAABQAAABAHwAAAAAAACYAAAAAAAAAwOD//wAAAAAmAAAAZAAAABYAAABMAAAAAAAAAAAAAAAEAAAAAAAAAAEAAABZWVkKAAAAACgAAAAoAAAAZAAAAGQAAAAAAAAAzMzMAAAAAABQAAAAUAAAAGQAAABkAAAAAAAAABcAAAAUAAAAAAAAAAAAAAD/fwAA/38AAAAAAAAJAAAABAAAAAAAAAAeAAAAaAAAAAAAAAAAAAAAAAAAAAAAAAAAAAAAECcAABAnAAAAAAAAAAAAAAAAAAAAAAAAAAAAAAAAAAAAAAAAAAAAABQAAAAAAAAAwMD/AAAAAABkAAAAMgAAAAAAAABkAAAAAAAAAH9/fwAKAAAAIgAAABgAAAAAAAAAAAAAAAAAAAAAAAAAAAAAAAAAAAAkAAAAJAAAAAAAAAAHAAAAAAAAAAAAAAAAAAAAAAAAAAAAAAAAAAAAf39/ACUAAABYAAAAAAAAAAAAAAAAAAAAAAAAAAAAAAAAAAAAAAAAAAAAAAAAAAAAAAAAAAAAAAA/AAAAAAAAAKCGAQAAAAAAAAAAAAAAAAAMAAAAAQAAAAAAAAAAAAAAAAAAAB8AAABUAAAAAAAABQAAAAEAAAAAAAAAAAAAAAAAAAAAAAAAAAAAAAAAAAAAAAAAAAAAAAJ/f38AAAAAA8zMzADAwP8Af39/AAAAAAAAAAAAAAAAAAAAAAAAAAAAIQAAABgAAAAUAAAAFAMAALYCAAB/NwAAvwoAABAAAAAmAAAACAAAADywAAAAAAAA"/>
               </a:ext>
             </a:extLst>
           </p:cNvSpPr>
@@ -3481,7 +3357,7 @@
           <p:cNvSpPr>
             <a:extLst>
               <a:ext uri="smNativeData">
-                <pr:smNativeData xmlns:pr="smNativeData" xmlns="smNativeData" val="SMDATA_15_EkJ5ZhMAAAAlAAAAZAAAAA0AAAAAkAAAAJAAAACQAAAAkAAAAAAAAAABAAAAAAAAAAEAAABQAAAAAAAAAAAA4D8AAAAAAADgPwAAAAAAAOA/AAAAAAAA4D8AAAAAAADgPwAAAAAAAOA/AAAAAAAA4D8AAAAAAADgPwAAAAAAAOA/AAAAAAAA4D8CAAAAjAAAAAEAAAAAAAAA+/v+AP///wgAAAAAAAAAAAAAAAAAAAAAAAAAAAAAAAAAAAAAeAAAAAEAAABAAAAAAAAAAAAAAABaAAAAAAAAAAAAAAAAAAAAAAAAAAAAAAAAAAAAAAAAAAAAAAAAAAAAAAAAAAAAAAAAAAAAAAAAAAAAAAAAAAAAAAAAAAAAAAAAAAAAFAAAADwAAAAAAAAAAAAAAAAAAAkUAAAAAQAAABQAAAAUAAAAFAAAAAEAAAAAAAAAZAAAAGQAAAAAAAAAZAAAAGQAAAAVAAAAYAAAAAAAAAAAAAAADwAAACADAAAAAAAAAAAAAAEAAACgMgAAVgcAAKr4//8BAAAAf39/AAEAAABkAAAAAAAAABQAAABAHwAAAAAAACYAAAAAAAAAwOD//wAAAAAmAAAAZAAAABYAAABMAAAAAAAAAAAAAAAEAAAAAAAAAAEAAABZWVkKAAAAACgAAAAoAAAAZAAAAGQAAAAAAAAAzMzMAAAAAABQAAAAUAAAAGQAAABkAAAAAAAAABcAAAAUAAAAAAAAAAAAAAD/fwAA/38AAAAAAAAJAAAABAAAAAAAAAAeAAAAaAAAAAAAAAAAAAAAAAAAAAAAAAAAAAAAECcAABAnAAAAAAAAAAAAAAAAAAAAAAAAAAAAAAAAAAAAAAAAAAAAABQAAAAAAAAAwMD/AAAAAABkAAAAMgAAAAAAAABkAAAAAAAAAH9/fwAKAAAAIgAAABgAAAAAAAAAAAAAAAAAAAAAAAAAAAAAAAAAAAAkAAAAJAAAAAAAAAAHAAAAAAAAAAAAAAAAAAAAAAAAAAAAAAAAAAAAf39/ACUAAABYAAAAAAAAAAAAAAAAAAAAAAAAAAAAAAAAAAAAAAAAAAAAAAAAAAAAAAAAAAAAAAA/AAAAAAAAAKCGAQAAAAAAAAAAAAAAAAAMAAAAAQAAAAAAAAAAAAAAAAAAAB8AAABUAAAA+/v+AAAAAAEAAAAAAAAAAAAAAAAAAAAAAAAAAAAAAAAAAAAAAAAAAAAAAAJ/f38AAAAAA8zMzADAwP8Af39/AAAAAAAAAAAAAAAAAAAAAAAAAAAAIQAAABgAAAAUAAAAuwMAAJYRAACQNAAAzSUAABAAAAAmAAAACAAAAP//////////"/>
+                <pr:smNativeData xmlns:pr="smNativeData" xmlns="smNativeData" val="SMDATA_15_LkR5ZhMAAAAlAAAAZAAAAA0AAAAAkAAAAJAAAACQAAAAkAAAAAAAAAABAAAAAAAAAAEAAABQAAAAAAAAAAAA4D8AAAAAAADgPwAAAAAAAOA/AAAAAAAA4D8AAAAAAADgPwAAAAAAAOA/AAAAAAAA4D8AAAAAAADgPwAAAAAAAOA/AAAAAAAA4D8CAAAAjAAAAAEAAAAAAAAA+/v+AP///wgAAAAAAAAAAAAAAAAAAAAAAAAAAAAAAAAAAAAAeAAAAAEAAABAAAAAAAAAAAAAAABaAAAAAAAAAAAAAAAAAAAAAAAAAAAAAAAAAAAAAAAAAAAAAAAAAAAAAAAAAAAAAAAAAAAAAAAAAAAAAAAAAAAAAAAAAAAAAAAAAAAAFAAAADwAAAAAAAAAAAAAAAAAAAkUAAAAAQAAABQAAAAUAAAAFAAAAAEAAAAAAAAAZAAAAGQAAAAAAAAAZAAAAGQAAAAVAAAAYAAAAAAAAAAAAAAADwAAACADAAAAAAAAAAAAAAEAAACgMgAAVgcAAKr4//8BAAAAf39/AAEAAABkAAAAAAAAABQAAABAHwAAAAAAACYAAAAAAAAAwOD//wAAAAAmAAAAZAAAABYAAABMAAAAAAAAAAAAAAAEAAAAAAAAAAEAAABZWVkKAAAAACgAAAAoAAAAZAAAAGQAAAAAAAAAzMzMAAAAAABQAAAAUAAAAGQAAABkAAAAAAAAABcAAAAUAAAAAAAAAAAAAAD/fwAA/38AAAAAAAAJAAAABAAAAAAAAAAeAAAAaAAAAAAAAAAAAAAAAAAAAAAAAAAAAAAAECcAABAnAAAAAAAAAAAAAAAAAAAAAAAAAAAAAAAAAAAAAAAAAAAAABQAAAAAAAAAwMD/AAAAAABkAAAAMgAAAAAAAABkAAAAAAAAAH9/fwAKAAAAIgAAABgAAAAAAAAAAAAAAAAAAAAAAAAAAAAAAAAAAAAkAAAAJAAAAAAAAAAHAAAAAAAAAAAAAAAAAAAAAAAAAAAAAAAAAAAAf39/ACUAAABYAAAAAAAAAAAAAAAAAAAAAAAAAAAAAAAAAAAAAAAAAAAAAAAAAAAAAAAAAAAAAAA/AAAAAAAAAKCGAQAAAAAAAAAAAAAAAAAMAAAAAQAAAAAAAAAAAAAAAAAAAB8AAABUAAAA+/v+AAAAAAEAAAAAAAAAAAAAAAAAAAAAAAAAAAAAAAAAAAAAAAAAAAAAAAJ/f38AAAAAA8zMzADAwP8Af39/AAAAAAAAAAAAAAAAAAAAAAAAAAAAIQAAABgAAAAUAAAAuwMAAJYRAACQNAAAzSUAABAAAAAmAAAACAAAAP//////////"/>
               </a:ext>
             </a:extLst>
           </p:cNvSpPr>
@@ -3526,7 +3402,7 @@
             <a:spLocks noGrp="1" noChangeArrowheads="1"/>
             <a:extLst>
               <a:ext uri="smNativeData">
-                <pr:smNativeData xmlns:pr="smNativeData" xmlns="smNativeData" val="SMDATA_15_EkJ5ZhMAAAAlAAAAZAAAAA0AAAAAkAAAAJAAAACQAAAAkAAAAAAAAAAAAAAAAAAAAAEAAABQAAAAAAAAAAAA4D8AAAAAAADgPwAAAAAAAOA/AAAAAAAA4D8AAAAAAADgPwAAAAAAAOA/AAAAAAAA4D8AAAAAAADgPwAAAAAAAOA/AAAAAAAA4D8CAAAAjAAAAAAAAAAAAAAAQoX0DP///wgAAAAAAAAAAAAAAAAAAAAAAAAAAAAAAAAAAAAAZAAAAAEAAABAAAAAAAAAAAAAAAAAAAAAAAAAAAAAAAAAAAAAAAAAAAAAAAAAAAAAAAAAAAAAAAAAAAAAAAAAAAAAAAAAAAAAAAAAAAAAAAAAAAAAAAAAAAAAAAAAAAAAFAAAADwAAAAAAAAAAAAAAAAAAAkUAAAAAQAAABQAAAAUAAAAFAAAAAEAAAAAAAAAZAAAAGQAAAAAAAAAZAAAAGQAAAAVAAAAYAAAAAAAAAAAAAAADwAAACADAAAAAAAAAAAAAAEAAACgMgAAVgcAAKr4//8BAAAAf39/AAEAAABkAAAAAAAAABQAAABAHwAAAAAAACYAAAAAAAAAwOD//wAAAAAmAAAAZAAAABYAAABMAAAAAAAAAAAAAAAEAAAAAAAAAAEAAABZWVkKAAAAACgAAAAoAAAAZAAAAGQAAAAAAAAAzMzMAAAAAABQAAAAUAAAAGQAAABkAAAAAAAAABcAAAAUAAAAAAAAAAAAAAD/fwAA/38AAAAAAAAJAAAABAAAAAAAAAAeAAAAaAAAAAAAAAAAAAAAAAAAAAAAAAAAAAAAECcAABAnAAAAAAAAAAAAAAAAAAAAAAAAAAAAAAAAAAAAAAAAAAAAABQAAAAAAAAAwMD/AAAAAABkAAAAMgAAAAAAAABkAAAAAAAAAH9/fwAKAAAAIgAAABgAAAAAAAAAAAAAAAAAAAAAAAAAAAAAAAAAAAAkAAAAJAAAAAAAAAAHAAAAAAAAAAAAAAAAAAAAAAAAAAAAAAAAAAAAf39/ACUAAABYAAAAAAAAAAAAAAAAAAAAAAAAAAAAAAAAAAAAAAAAAAAAAAAAAAAAAAAAAAAAAAA/AAAAAAAAAKCGAQAAAAAAAAAAAAAAAAAMAAAAAQAAAAAAAAAAAAAAAAAAAB8AAABUAAAAAAAABQAAAAEAAAAAAAAAAAAAAAAAAAAAAAAAAAAAAAAAAAAAAAAAAAAAAAJ/f38AAAAAA8zMzADAwP8Af39/AAAAAAAAAAAAAAAAAAAAAAAAAAAAIQAAABgAAAAUAAAAfAQAAIESAAC5NQAAuCYAABAAAAAmAAAACAAAAD2wAAAAAAAA"/>
+                <pr:smNativeData xmlns:pr="smNativeData" xmlns="smNativeData" val="SMDATA_15_LkR5ZhMAAAAlAAAAZAAAAA0AAAAAkAAAAJAAAACQAAAAkAAAAAAAAAAAAAAAAAAAAAEAAABQAAAAAAAAAAAA4D8AAAAAAADgPwAAAAAAAOA/AAAAAAAA4D8AAAAAAADgPwAAAAAAAOA/AAAAAAAA4D8AAAAAAADgPwAAAAAAAOA/AAAAAAAA4D8CAAAAjAAAAAAAAAAAAAAAQoX0DP///wgAAAAAAAAAAAAAAAAAAAAAAAAAAAAAAAAAAAAAZAAAAAEAAABAAAAAAAAAAAAAAAAAAAAAAAAAAAAAAAAAAAAAAAAAAAAAAAAAAAAAAAAAAAAAAAAAAAAAAAAAAAAAAAAAAAAAAAAAAAAAAAAAAAAAAAAAAAAAAAAAAAAAFAAAADwAAAAAAAAAAAAAAAAAAAkUAAAAAQAAABQAAAAUAAAAFAAAAAEAAAAAAAAAZAAAAGQAAAAAAAAAZAAAAGQAAAAVAAAAYAAAAAAAAAAAAAAADwAAACADAAAAAAAAAAAAAAEAAACgMgAAVgcAAKr4//8BAAAAf39/AAEAAABkAAAAAAAAABQAAABAHwAAAAAAACYAAAAAAAAAwOD//wAAAAAmAAAAZAAAABYAAABMAAAAAAAAAAAAAAAEAAAAAAAAAAEAAABZWVkKAAAAACgAAAAoAAAAZAAAAGQAAAAAAAAAzMzMAAAAAABQAAAAUAAAAGQAAABkAAAAAAAAABcAAAAUAAAAAAAAAAAAAAD/fwAA/38AAAAAAAAJAAAABAAAAAAAAAAeAAAAaAAAAAAAAAAAAAAAAAAAAAAAAAAAAAAAECcAABAnAAAAAAAAAAAAAAAAAAAAAAAAAAAAAAAAAAAAAAAAAAAAABQAAAAAAAAAwMD/AAAAAABkAAAAMgAAAAAAAABkAAAAAAAAAH9/fwAKAAAAIgAAABgAAAAAAAAAAAAAAAAAAAAAAAAAAAAAAAAAAAAkAAAAJAAAAAAAAAAHAAAAAAAAAAAAAAAAAAAAAAAAAAAAAAAAAAAAf39/ACUAAABYAAAAAAAAAAAAAAAAAAAAAAAAAAAAAAAAAAAAAAAAAAAAAAAAAAAAAAAAAAAAAAA/AAAAAAAAAKCGAQAAAAAAAAAAAAAAAAAMAAAAAQAAAAAAAAAAAAAAAAAAAB8AAABUAAAAAAAABQAAAAEAAAAAAAAAAAAAAAAAAAAAAAAAAAAAAAAAAAAAAAAAAAAAAAJ/f38AAAAAA8zMzADAwP8Af39/AAAAAAAAAAAAAAAAAAAAAAAAAAAAIQAAABgAAAAUAAAAfAQAAIESAAC5NQAAuCYAABAAAAAmAAAACAAAAD2wAAAAAAAA"/>
               </a:ext>
             </a:extLst>
           </p:cNvSpPr>
@@ -3709,7 +3585,7 @@
             <a:spLocks noGrp="1" noChangeArrowheads="1"/>
             <a:extLst>
               <a:ext uri="smNativeData">
-                <pr:smNativeData xmlns:pr="smNativeData" xmlns="smNativeData" val="SMDATA_15_EkJ5ZhMAAAAlAAAAZAAAAA0AAAAAkAAAAJAAAACQAAAAkAAAAAAAAAAAAAAAAAAAAAEAAABQAAAAAAAAAAAA4D8AAAAAAADgPwAAAAAAAOA/AAAAAAAA4D8AAAAAAADgPwAAAAAAAOA/AAAAAAAA4D8AAAAAAADgPwAAAAAAAOA/AAAAAAAA4D8CAAAAjAAAAAAAAAAAAAAAQoX0DP///wgAAAAAAAAAAAAAAAAAAAAAAAAAAAAAAAAAAAAAZAAAAAEAAABAAAAAAAAAAAAAAAAAAAAAAAAAAAAAAAAAAAAAAAAAAAAAAAAAAAAAAAAAAAAAAAAAAAAAAAAAAAAAAAAAAAAAAAAAAAAAAAAAAAAAAAAAAAAAAAAAAAAAFAAAADwAAAAAAAAAAAAAAAAAAAkUAAAAAQAAABQAAAAUAAAAFAAAAAEAAAAAAAAAZAAAAGQAAAAAAAAAZAAAAGQAAAAVAAAAYAAAAAAAAAAAAAAADwAAACADAAAAAAAAAAAAAAEAAACgMgAAVgcAAKr4//8BAAAAf39/AAEAAABkAAAAAAAAABQAAABAHwAAAAAAACYAAAAAAAAAwOD//wAAAAAmAAAAZAAAABYAAABMAAAAAAAAAAAAAAAEAAAAAAAAAAEAAABZWVkKAAAAACgAAAAoAAAAZAAAAGQAAAAAAAAAzMzMAAAAAABQAAAAUAAAAGQAAABkAAAAAAAAABcAAAAUAAAAAAAAAAAAAAD/fwAA/38AAAAAAAAJAAAABAAAAAAAAAAeAAAAaAAAAAAAAAAAAAAAAAAAAAAAAAAAAAAAECcAABAnAAAAAAAAAAAAAAAAAAAAAAAAAAAAAAAAAAAAAAAAAAAAABQAAAAAAAAAwMD/AAAAAABkAAAAMgAAAAAAAABkAAAAAAAAAH9/fwAKAAAAIgAAABgAAAAAAAAAAAAAAAAAAAAAAAAAAAAAAAAAAAAkAAAAJAAAAAAAAAAHAAAAAAAAAAAAAAAAAAAAAAAAAAAAAAAAAAAAf39/ACUAAABYAAAAAAAAAAAAAAAAAAAAAAAAAAAAAAAAAAAAAAAAAAAAAAAAAAAAAAAAAAAAAAA/AAAAAAAAAKCGAQAAAAAAAAAAAAAAAAAMAAAAAQAAAAAAAAAAAAAAAAAAAB8AAABUAAAAAAAABQAAAAEAAAAAAAAAAAAAAAAAAAAAAAAAAAAAAAAAAAAAAAAAAAAAAAJ/f38AAAAAA8zMzADAwP8Af39/AAAAAAAAAAAAAAAAAAAAAAAAAAAAIQAAABgAAAAUAAAAQwMAAA4LAABBNQAAlhEAABAAAAAmAAAACAAAAD2wAAAAAAAA"/>
+                <pr:smNativeData xmlns:pr="smNativeData" xmlns="smNativeData" val="SMDATA_15_LkR5ZhMAAAAlAAAAZAAAAA0AAAAAkAAAAJAAAACQAAAAkAAAAAAAAAAAAAAAAAAAAAEAAABQAAAAAAAAAAAA4D8AAAAAAADgPwAAAAAAAOA/AAAAAAAA4D8AAAAAAADgPwAAAAAAAOA/AAAAAAAA4D8AAAAAAADgPwAAAAAAAOA/AAAAAAAA4D8CAAAAjAAAAAAAAAAAAAAAQoX0DP///wgAAAAAAAAAAAAAAAAAAAAAAAAAAAAAAAAAAAAAZAAAAAEAAABAAAAAAAAAAAAAAAAAAAAAAAAAAAAAAAAAAAAAAAAAAAAAAAAAAAAAAAAAAAAAAAAAAAAAAAAAAAAAAAAAAAAAAAAAAAAAAAAAAAAAAAAAAAAAAAAAAAAAFAAAADwAAAAAAAAAAAAAAAAAAAkUAAAAAQAAABQAAAAUAAAAFAAAAAEAAAAAAAAAZAAAAGQAAAAAAAAAZAAAAGQAAAAVAAAAYAAAAAAAAAAAAAAADwAAACADAAAAAAAAAAAAAAEAAACgMgAAVgcAAKr4//8BAAAAf39/AAEAAABkAAAAAAAAABQAAABAHwAAAAAAACYAAAAAAAAAwOD//wAAAAAmAAAAZAAAABYAAABMAAAAAAAAAAAAAAAEAAAAAAAAAAEAAABZWVkKAAAAACgAAAAoAAAAZAAAAGQAAAAAAAAAzMzMAAAAAABQAAAAUAAAAGQAAABkAAAAAAAAABcAAAAUAAAAAAAAAAAAAAD/fwAA/38AAAAAAAAJAAAABAAAAAAAAAAeAAAAaAAAAAAAAAAAAAAAAAAAAAAAAAAAAAAAECcAABAnAAAAAAAAAAAAAAAAAAAAAAAAAAAAAAAAAAAAAAAAAAAAABQAAAAAAAAAwMD/AAAAAABkAAAAMgAAAAAAAABkAAAAAAAAAH9/fwAKAAAAIgAAABgAAAAAAAAAAAAAAAAAAAAAAAAAAAAAAAAAAAAkAAAAJAAAAAAAAAAHAAAAAAAAAAAAAAAAAAAAAAAAAAAAAAAAAAAAf39/ACUAAABYAAAAAAAAAAAAAAAAAAAAAAAAAAAAAAAAAAAAAAAAAAAAAAAAAAAAAAAAAAAAAAA/AAAAAAAAAKCGAQAAAAAAAAAAAAAAAAAMAAAAAQAAAAAAAAAAAAAAAAAAAB8AAABUAAAAAAAABQAAAAEAAAAAAAAAAAAAAAAAAAAAAAAAAAAAAAAAAAAAAAAAAAAAAAJ/f38AAAAAA8zMzADAwP8Af39/AAAAAAAAAAAAAAAAAAAAAAAAAAAAIQAAABgAAAAUAAAAQwMAAA4LAABBNQAAlhEAABAAAAAmAAAACAAAAD2wAAAAAAAA"/>
               </a:ext>
             </a:extLst>
           </p:cNvSpPr>
@@ -3921,7 +3797,7 @@
             <a:spLocks noGrp="1" noChangeArrowheads="1"/>
             <a:extLst>
               <a:ext uri="smNativeData">
-                <pr:smNativeData xmlns:pr="smNativeData" xmlns="smNativeData" val="SMDATA_15_EkJ5ZhMAAAAlAAAAZAAAAA0AAAAAkAAAAJAAAACQAAAAkAAAAAAAAAAAAAAAAAAAAAEAAABQAAAAAAAAAAAA4D8AAAAAAADgPwAAAAAAAOA/AAAAAAAA4D8AAAAAAADgPwAAAAAAAOA/AAAAAAAA4D8AAAAAAADgPwAAAAAAAOA/AAAAAAAA4D8CAAAAjAAAAAAAAAAAAAAAQoX0DP///wgAAAAAAAAAAAAAAAAAAAAAAAAAAAAAAAAAAAAAZAAAAAEAAABAAAAAAAAAAAAAAAAAAAAAAAAAAAAAAAAAAAAAAAAAAAAAAAAAAAAAAAAAAAAAAAAAAAAAAAAAAAAAAAAAAAAAAAAAAAAAAAAAAAAAAAAAAAAAAAAAAAAAFAAAADwAAAAAAAAAAAAAAAAAAAkUAAAAAQAAABQAAAAUAAAAFAAAAAEAAAAAAAAAZAAAAGQAAAAAAAAAZAAAAGQAAAAVAAAAYAAAAAAAAAAAAAAADwAAACADAAAAAAAAAAAAAAEAAACgMgAAVgcAAKr4//8BAAAAf39/AAEAAABkAAAAAAAAABQAAABAHwAAAAAAACYAAAAAAAAAwOD//wAAAAAmAAAAZAAAABYAAABMAAAAAAAAAAAAAAAEAAAAAAAAAAEAAABZWVkKAAAAACgAAAAoAAAAZAAAAGQAAAAAAAAAzMzMAAAAAABQAAAAUAAAAGQAAABkAAAAAAAAABcAAAAUAAAAAAAAAAAAAAD/fwAA/38AAAAAAAAJAAAABAAAAAAAAAAeAAAAaAAAAAAAAAAAAAAAAAAAAAAAAAAAAAAAECcAABAnAAAAAAAAAAAAAAAAAAAAAAAAAAAAAAAAAAAAAAAAAAAAABQAAAAAAAAAwMD/AAAAAABkAAAAMgAAAAAAAABkAAAAAAAAAH9/fwAKAAAAIgAAABgAAAAAAAAAAAAAAAAAAAAAAAAAAAAAAAAAAAAkAAAAJAAAAAAAAAAHAAAAAAAAAAAAAAAAAAAAAAAAAAAAAAAAAAAAf39/ACUAAABYAAAAAAAAAAAAAAAAAAAAAAAAAAAAAAAAAAAAAAAAAAAAAAAAAAAAAAAAAAAAAAA/AAAAAAAAAKCGAQAAAAAAAAAAAAAAAAAMAAAAAQAAAAAAAAAAAAAAAAAAAB8AAABUAAAAAAAABQAAAAEAAAAAAAAAAAAAAAAAAAAAAAAAAAAAAAAAAAAAAAAAAAAAAAJ/f38AAAAAA8zMzADAwP8Af39/AAAAAAAAAAAAAAAAAAAAAAAAAAAAIQAAABgAAAAUAAAAFAMAALYCAAB/NwAAvwoAABAAAAAmAAAACAAAADywAAAAAAAA"/>
+                <pr:smNativeData xmlns:pr="smNativeData" xmlns="smNativeData" val="SMDATA_15_LkR5ZhMAAAAlAAAAZAAAAA0AAAAAkAAAAJAAAACQAAAAkAAAAAAAAAAAAAAAAAAAAAEAAABQAAAAAAAAAAAA4D8AAAAAAADgPwAAAAAAAOA/AAAAAAAA4D8AAAAAAADgPwAAAAAAAOA/AAAAAAAA4D8AAAAAAADgPwAAAAAAAOA/AAAAAAAA4D8CAAAAjAAAAAAAAAAAAAAAQoX0DP///wgAAAAAAAAAAAAAAAAAAAAAAAAAAAAAAAAAAAAAZAAAAAEAAABAAAAAAAAAAAAAAAAAAAAAAAAAAAAAAAAAAAAAAAAAAAAAAAAAAAAAAAAAAAAAAAAAAAAAAAAAAAAAAAAAAAAAAAAAAAAAAAAAAAAAAAAAAAAAAAAAAAAAFAAAADwAAAAAAAAAAAAAAAAAAAkUAAAAAQAAABQAAAAUAAAAFAAAAAEAAAAAAAAAZAAAAGQAAAAAAAAAZAAAAGQAAAAVAAAAYAAAAAAAAAAAAAAADwAAACADAAAAAAAAAAAAAAEAAACgMgAAVgcAAKr4//8BAAAAf39/AAEAAABkAAAAAAAAABQAAABAHwAAAAAAACYAAAAAAAAAwOD//wAAAAAmAAAAZAAAABYAAABMAAAAAAAAAAAAAAAEAAAAAAAAAAEAAABZWVkKAAAAACgAAAAoAAAAZAAAAGQAAAAAAAAAzMzMAAAAAABQAAAAUAAAAGQAAABkAAAAAAAAABcAAAAUAAAAAAAAAAAAAAD/fwAA/38AAAAAAAAJAAAABAAAAAAAAAAeAAAAaAAAAAAAAAAAAAAAAAAAAAAAAAAAAAAAECcAABAnAAAAAAAAAAAAAAAAAAAAAAAAAAAAAAAAAAAAAAAAAAAAABQAAAAAAAAAwMD/AAAAAABkAAAAMgAAAAAAAABkAAAAAAAAAH9/fwAKAAAAIgAAABgAAAAAAAAAAAAAAAAAAAAAAAAAAAAAAAAAAAAkAAAAJAAAAAAAAAAHAAAAAAAAAAAAAAAAAAAAAAAAAAAAAAAAAAAAf39/ACUAAABYAAAAAAAAAAAAAAAAAAAAAAAAAAAAAAAAAAAAAAAAAAAAAAAAAAAAAAAAAAAAAAA/AAAAAAAAAKCGAQAAAAAAAAAAAAAAAAAMAAAAAQAAAAAAAAAAAAAAAAAAAB8AAABUAAAAAAAABQAAAAEAAAAAAAAAAAAAAAAAAAAAAAAAAAAAAAAAAAAAAAAAAAAAAAJ/f38AAAAAA8zMzADAwP8Af39/AAAAAAAAAAAAAAAAAAAAAAAAAAAAIQAAABgAAAAUAAAAFAMAALYCAAB/NwAAvwoAABAAAAAmAAAACAAAADywAAAAAAAA"/>
               </a:ext>
             </a:extLst>
           </p:cNvSpPr>
@@ -4030,7 +3906,7 @@
           <p:cNvSpPr>
             <a:extLst>
               <a:ext uri="smNativeData">
-                <pr:smNativeData xmlns:pr="smNativeData" xmlns="smNativeData" val="SMDATA_15_EkJ5ZhMAAAAlAAAAZAAAAA0AAAAAkAAAAJAAAACQAAAAkAAAAAAAAAABAAAAAAAAAAEAAABQAAAAAAAAAAAA4D8AAAAAAADgPwAAAAAAAOA/AAAAAAAA4D8AAAAAAADgPwAAAAAAAOA/AAAAAAAA4D8AAAAAAADgPwAAAAAAAOA/AAAAAAAA4D8CAAAAjAAAAAEAAAAAAAAA+/v+AP///wgAAAAAAAAAAAAAAAAAAAAAAAAAAAAAAAAAAAAAeAAAAAEAAABAAAAAAAAAAAAAAABaAAAAAAAAAAAAAAAAAAAAAAAAAAAAAAAAAAAAAAAAAAAAAAAAAAAAAAAAAAAAAAAAAAAAAAAAAAAAAAAAAAAAAAAAAAAAAAAAAAAAFAAAADwAAAAAAAAAAAAAAAAAAAkUAAAAAQAAABQAAAAUAAAAFAAAAAEAAAAAAAAAZAAAAGQAAAAAAAAAZAAAAGQAAAAVAAAAYAAAAAAAAAAAAAAADwAAACADAAAAAAAAAAAAAAEAAACgMgAAVgcAAKr4//8BAAAAf39/AAEAAABkAAAAAAAAABQAAABAHwAAAAAAACYAAAAAAAAAwOD//wAAAAAmAAAAZAAAABYAAABMAAAAAAAAAAAAAAAEAAAAAAAAAAEAAABZWVkKAAAAACgAAAAoAAAAZAAAAGQAAAAAAAAAzMzMAAAAAABQAAAAUAAAAGQAAABkAAAAAAAAABcAAAAUAAAAAAAAAAAAAAD/fwAA/38AAAAAAAAJAAAABAAAAAAAAAAeAAAAaAAAAAAAAAAAAAAAAAAAAAAAAAAAAAAAECcAABAnAAAAAAAAAAAAAAAAAAAAAAAAAAAAAAAAAAAAAAAAAAAAABQAAAAAAAAAwMD/AAAAAABkAAAAMgAAAAAAAABkAAAAAAAAAH9/fwAKAAAAIgAAABgAAAAAAAAAAAAAAAAAAAAAAAAAAAAAAAAAAAAkAAAAJAAAAAAAAAAHAAAAAAAAAAAAAAAAAAAAAAAAAAAAAAAAAAAAf39/ACUAAABYAAAAAAAAAAAAAAAAAAAAAAAAAAAAAAAAAAAAAAAAAAAAAAAAAAAAAAAAAAAAAAA/AAAAAAAAAKCGAQAAAAAAAAAAAAAAAAAMAAAAAQAAAAAAAAAAAAAAAAAAAB8AAABUAAAA+/v+AAAAAAEAAAAAAAAAAAAAAAAAAAAAAAAAAAAAAAAAAAAAAAAAAAAAAAJ/f38AAAAAA8zMzADAwP8Af39/AAAAAAAAAAAAAAAAAAAAAAAAAAAAIQAAABgAAAAUAAAAOwIAAPIJAABxHwAALycAABAAAAAmAAAACAAAAP//////////"/>
+                <pr:smNativeData xmlns:pr="smNativeData" xmlns="smNativeData" val="SMDATA_15_LkR5ZhMAAAAlAAAAZAAAAA0AAAAAkAAAAJAAAACQAAAAkAAAAAAAAAABAAAAAAAAAAEAAABQAAAAAAAAAAAA4D8AAAAAAADgPwAAAAAAAOA/AAAAAAAA4D8AAAAAAADgPwAAAAAAAOA/AAAAAAAA4D8AAAAAAADgPwAAAAAAAOA/AAAAAAAA4D8CAAAAjAAAAAEAAAAAAAAA+/v+AP///wgAAAAAAAAAAAAAAAAAAAAAAAAAAAAAAAAAAAAAeAAAAAEAAABAAAAAAAAAAAAAAABaAAAAAAAAAAAAAAAAAAAAAAAAAAAAAAAAAAAAAAAAAAAAAAAAAAAAAAAAAAAAAAAAAAAAAAAAAAAAAAAAAAAAAAAAAAAAAAAAAAAAFAAAADwAAAAAAAAAAAAAAAAAAAkUAAAAAQAAABQAAAAUAAAAFAAAAAEAAAAAAAAAZAAAAGQAAAAAAAAAZAAAAGQAAAAVAAAAYAAAAAAAAAAAAAAADwAAACADAAAAAAAAAAAAAAEAAACgMgAAVgcAAKr4//8BAAAAf39/AAEAAABkAAAAAAAAABQAAABAHwAAAAAAACYAAAAAAAAAwOD//wAAAAAmAAAAZAAAABYAAABMAAAAAAAAAAAAAAAEAAAAAAAAAAEAAABZWVkKAAAAACgAAAAoAAAAZAAAAGQAAAAAAAAAzMzMAAAAAABQAAAAUAAAAGQAAABkAAAAAAAAABcAAAAUAAAAAAAAAAAAAAD/fwAA/38AAAAAAAAJAAAABAAAAAAAAAAeAAAAaAAAAAAAAAAAAAAAAAAAAAAAAAAAAAAAECcAABAnAAAAAAAAAAAAAAAAAAAAAAAAAAAAAAAAAAAAAAAAAAAAABQAAAAAAAAAwMD/AAAAAABkAAAAMgAAAAAAAABkAAAAAAAAAH9/fwAKAAAAIgAAABgAAAAAAAAAAAAAAAAAAAAAAAAAAAAAAAAAAAAkAAAAJAAAAAAAAAAHAAAAAAAAAAAAAAAAAAAAAAAAAAAAAAAAAAAAf39/ACUAAABYAAAAAAAAAAAAAAAAAAAAAAAAAAAAAAAAAAAAAAAAAAAAAAAAAAAAAAAAAAAAAAA/AAAAAAAAAKCGAQAAAAAAAAAAAAAAAAAMAAAAAQAAAAAAAAAAAAAAAAAAAB8AAABUAAAA+/v+AAAAAAEAAAAAAAAAAAAAAAAAAAAAAAAAAAAAAAAAAAAAAAAAAAAAAAJ/f38AAAAAA8zMzADAwP8Af39/AAAAAAAAAAAAAAAAAAAAAAAAAAAAIQAAABgAAAAUAAAAOwIAAPIJAABxHwAALycAABAAAAAmAAAACAAAAP//////////"/>
               </a:ext>
             </a:extLst>
           </p:cNvSpPr>
@@ -4075,7 +3951,7 @@
             <a:spLocks noGrp="1" noChangeArrowheads="1"/>
             <a:extLst>
               <a:ext uri="smNativeData">
-                <pr:smNativeData xmlns:pr="smNativeData" xmlns="smNativeData" val="SMDATA_15_EkJ5ZhMAAAAlAAAAZAAAAA0AAAAAkAAAAJAAAACQAAAAkAAAAAAAAAAAAAAAAAAAAAEAAABQAAAAAAAAAAAA4D8AAAAAAADgPwAAAAAAAOA/AAAAAAAA4D8AAAAAAADgPwAAAAAAAOA/AAAAAAAA4D8AAAAAAADgPwAAAAAAAOA/AAAAAAAA4D8CAAAAjAAAAAAAAAAAAAAAQoX0DP///wgAAAAAAAAAAAAAAAAAAAAAAAAAAAAAAAAAAAAAZAAAAAEAAABAAAAAAAAAAAAAAAAAAAAAAAAAAAAAAAAAAAAAAAAAAAAAAAAAAAAAAAAAAAAAAAAAAAAAAAAAAAAAAAAAAAAAAAAAAAAAAAAAAAAAAAAAAAAAAAAAAAAAFAAAADwAAAAAAAAAAAAAAAAAAAkUAAAAAQAAABQAAAAUAAAAFAAAAAEAAAAAAAAAZAAAAGQAAAAAAAAAZAAAAGQAAAAVAAAAYAAAAAAAAAAAAAAADwAAACADAAAAAAAAAAAAAAEAAACgMgAAVgcAAKr4//8BAAAAf39/AAEAAABkAAAAAAAAABQAAABAHwAAAAAAACYAAAAAAAAAwOD//wAAAAAmAAAAZAAAABYAAABMAAAAAAAAAAAAAAAEAAAAAAAAAAEAAABZWVkKAAAAACgAAAAoAAAAZAAAAGQAAAAAAAAAzMzMAAAAAABQAAAAUAAAAGQAAABkAAAAAAAAABcAAAAUAAAAAAAAAAAAAAD/fwAA/38AAAAAAAAJAAAABAAAAAAAAAAeAAAAaAAAAAAAAAAAAAAAAAAAAAAAAAAAAAAAECcAABAnAAAAAAAAAAAAAAAAAAAAAAAAAAAAAAAAAAAAAAAAAAAAABQAAAAAAAAAwMD/AAAAAABkAAAAMgAAAAAAAABkAAAAAAAAAH9/fwAKAAAAIgAAABgAAAAAAAAAAAAAAAAAAAAAAAAAAAAAAAAAAAAkAAAAJAAAAAAAAAAHAAAAAAAAAAAAAAAAAAAAAAAAAAAAAAAAAAAAf39/ACUAAABYAAAAAAAAAAAAAAAAAAAAAAAAAAAAAAAAAAAAAAAAAAAAAAAAAAAAAAAAAAAAAAA/AAAAAAAAAKCGAQAAAAAAAAAAAAAAAAAMAAAAAQAAAAAAAAAAAAAAAAAAAB8AAABUAAAAAAAABQAAAAEAAAAAAAAAAAAAAAAAAAAAAAAAAAAAAAAAAAAAAAAAAAAAAAJ/f38AAAAAA8zMzADAwP8Af39/AAAAAAAAAAAAAAAAAAAAAAAAAAAAIQAAABgAAAAUAAAAFAMAANkKAABSHgAAMCcAABAAAAAmAAAACAAAAD2wAAAAAAAA"/>
+                <pr:smNativeData xmlns:pr="smNativeData" xmlns="smNativeData" val="SMDATA_15_LkR5ZhMAAAAlAAAAZAAAAA0AAAAAkAAAAJAAAACQAAAAkAAAAAAAAAAAAAAAAAAAAAEAAABQAAAAAAAAAAAA4D8AAAAAAADgPwAAAAAAAOA/AAAAAAAA4D8AAAAAAADgPwAAAAAAAOA/AAAAAAAA4D8AAAAAAADgPwAAAAAAAOA/AAAAAAAA4D8CAAAAjAAAAAAAAAAAAAAAQoX0DP///wgAAAAAAAAAAAAAAAAAAAAAAAAAAAAAAAAAAAAAZAAAAAEAAABAAAAAAAAAAAAAAAAAAAAAAAAAAAAAAAAAAAAAAAAAAAAAAAAAAAAAAAAAAAAAAAAAAAAAAAAAAAAAAAAAAAAAAAAAAAAAAAAAAAAAAAAAAAAAAAAAAAAAFAAAADwAAAAAAAAAAAAAAAAAAAkUAAAAAQAAABQAAAAUAAAAFAAAAAEAAAAAAAAAZAAAAGQAAAAAAAAAZAAAAGQAAAAVAAAAYAAAAAAAAAAAAAAADwAAACADAAAAAAAAAAAAAAEAAACgMgAAVgcAAKr4//8BAAAAf39/AAEAAABkAAAAAAAAABQAAABAHwAAAAAAACYAAAAAAAAAwOD//wAAAAAmAAAAZAAAABYAAABMAAAAAAAAAAAAAAAEAAAAAAAAAAEAAABZWVkKAAAAACgAAAAoAAAAZAAAAGQAAAAAAAAAzMzMAAAAAABQAAAAUAAAAGQAAABkAAAAAAAAABcAAAAUAAAAAAAAAAAAAAD/fwAA/38AAAAAAAAJAAAABAAAAAAAAAAeAAAAaAAAAAAAAAAAAAAAAAAAAAAAAAAAAAAAECcAABAnAAAAAAAAAAAAAAAAAAAAAAAAAAAAAAAAAAAAAAAAAAAAABQAAAAAAAAAwMD/AAAAAABkAAAAMgAAAAAAAABkAAAAAAAAAH9/fwAKAAAAIgAAABgAAAAAAAAAAAAAAAAAAAAAAAAAAAAAAAAAAAAkAAAAJAAAAAAAAAAHAAAAAAAAAAAAAAAAAAAAAAAAAAAAAAAAAAAAf39/ACUAAABYAAAAAAAAAAAAAAAAAAAAAAAAAAAAAAAAAAAAAAAAAAAAAAAAAAAAAAAAAAAAAAA/AAAAAAAAAKCGAQAAAAAAAAAAAAAAAAAMAAAAAQAAAAAAAAAAAAAAAAAAAB8AAABUAAAAAAAABQAAAAEAAAAAAAAAAAAAAAAAAAAAAAAAAAAAAAAAAAAAAAAAAAAAAAJ/f38AAAAAA8zMzADAwP8Af39/AAAAAAAAAAAAAAAAAAAAAAAAAAAAIQAAABgAAAAUAAAAFAMAANkKAABSHgAAMCcAABAAAAAmAAAACAAAAD2wAAAAAAAA"/>
               </a:ext>
             </a:extLst>
           </p:cNvSpPr>
@@ -4230,7 +4106,7 @@
             <a:spLocks noGrp="1" noChangeArrowheads="1"/>
             <a:extLst>
               <a:ext uri="smNativeData">
-                <pr:smNativeData xmlns:pr="smNativeData" xmlns="smNativeData" val="SMDATA_15_EkJ5ZhMAAAAlAAAAZAAAAA0AAAAAkAAAAJAAAACQAAAAkAAAAAAAAAAAAAAAAAAAAAEAAABQAAAAAAAAAAAA4D8AAAAAAADgPwAAAAAAAOA/AAAAAAAA4D8AAAAAAADgPwAAAAAAAOA/AAAAAAAA4D8AAAAAAADgPwAAAAAAAOA/AAAAAAAA4D8CAAAAjAAAAAAAAAAAAAAAQoX0DP///wgAAAAAAAAAAAAAAAAAAAAAAAAAAAAAAAAAAAAAZAAAAAEAAABAAAAAAAAAAAAAAAAAAAAAAAAAAAAAAAAAAAAAAAAAAAAAAAAAAAAAAAAAAAAAAAAAAAAAAAAAAAAAAAAAAAAAAAAAAAAAAAAAAAAAAAAAAAAAAAAAAAAAFAAAADwAAAAAAAAAAAAAAAAAAAkUAAAAAQAAABQAAAAUAAAAFAAAAAEAAAAAAAAAZAAAAGQAAAAAAAAAZAAAAGQAAAAVAAAAYAAAAAAAAAAAAAAADwAAACADAAAAAAAAAAAAAAEAAACgMgAAVgcAAKr4//8BAAAAf39/AAEAAABkAAAAAAAAABQAAABAHwAAAAAAACYAAAAAAAAAwOD//wAAAAAmAAAAZAAAABYAAABMAAAAAAAAAAAAAAAEAAAAAAAAAAEAAABZWVkKAAAAACgAAAAoAAAAZAAAAGQAAAAAAAAAzMzMAAAAAABQAAAAUAAAAGQAAABkAAAAAAAAABcAAAAUAAAAAAAAAAAAAAD/fwAA/38AAAAAAAAJAAAABAAAAAAAAAAeAAAAaAAAAAAAAAAAAAAAAAAAAAAAAAAAAAAAECcAABAnAAAAAAAAAAAAAAAAAAAAAAAAAAAAAAAAAAAAAAAAAAAAABQAAAAAAAAAwMD/AAAAAABkAAAAMgAAAAAAAABkAAAAAAAAAH9/fwAKAAAAIgAAABgAAAAAAAAAAAAAAAAAAAAAAAAAAAAAAAAAAAAkAAAAJAAAAAAAAAAHAAAAAAAAAAAAAAAAAAAAAAAAAAAAAAAAAAAAf39/ACUAAABYAAAAAAAAAAAAAAAAAAAAAAAAAAAAAAAAAAAAAAAAAAAAAAAAAAAAAAAAAAAAAAA/AAAAAAAAAKCGAQAAAAAAAAAAAAAAAAAMAAAAAQAAAAAAAAAAAAAAAAAAAB8AAABUAAAAAAAABQAAAAEAAAAAAAAAAAAAAAAAAAAAAAAAAAAAAAAAAAAAAAAAAAAAAAJ/f38AAAAAA8zMzADAwP8Af39/AAAAAAAAAAAAAAAAAAAAAAAAAAAAIQAAABgAAAAUAAAALCIAANkKAACPNQAAmCUAABAAAAAmAAAACAAAAD2wAAAAAAAA"/>
+                <pr:smNativeData xmlns:pr="smNativeData" xmlns="smNativeData" val="SMDATA_15_LkR5ZhMAAAAlAAAAZAAAAA0AAAAAkAAAAJAAAACQAAAAkAAAAAAAAAAAAAAAAAAAAAEAAABQAAAAAAAAAAAA4D8AAAAAAADgPwAAAAAAAOA/AAAAAAAA4D8AAAAAAADgPwAAAAAAAOA/AAAAAAAA4D8AAAAAAADgPwAAAAAAAOA/AAAAAAAA4D8CAAAAjAAAAAAAAAAAAAAAQoX0DP///wgAAAAAAAAAAAAAAAAAAAAAAAAAAAAAAAAAAAAAZAAAAAEAAABAAAAAAAAAAAAAAAAAAAAAAAAAAAAAAAAAAAAAAAAAAAAAAAAAAAAAAAAAAAAAAAAAAAAAAAAAAAAAAAAAAAAAAAAAAAAAAAAAAAAAAAAAAAAAAAAAAAAAFAAAADwAAAAAAAAAAAAAAAAAAAkUAAAAAQAAABQAAAAUAAAAFAAAAAEAAAAAAAAAZAAAAGQAAAAAAAAAZAAAAGQAAAAVAAAAYAAAAAAAAAAAAAAADwAAACADAAAAAAAAAAAAAAEAAACgMgAAVgcAAKr4//8BAAAAf39/AAEAAABkAAAAAAAAABQAAABAHwAAAAAAACYAAAAAAAAAwOD//wAAAAAmAAAAZAAAABYAAABMAAAAAAAAAAAAAAAEAAAAAAAAAAEAAABZWVkKAAAAACgAAAAoAAAAZAAAAGQAAAAAAAAAzMzMAAAAAABQAAAAUAAAAGQAAABkAAAAAAAAABcAAAAUAAAAAAAAAAAAAAD/fwAA/38AAAAAAAAJAAAABAAAAAAAAAAeAAAAaAAAAAAAAAAAAAAAAAAAAAAAAAAAAAAAECcAABAnAAAAAAAAAAAAAAAAAAAAAAAAAAAAAAAAAAAAAAAAAAAAABQAAAAAAAAAwMD/AAAAAABkAAAAMgAAAAAAAABkAAAAAAAAAH9/fwAKAAAAIgAAABgAAAAAAAAAAAAAAAAAAAAAAAAAAAAAAAAAAAAkAAAAJAAAAAAAAAAHAAAAAAAAAAAAAAAAAAAAAAAAAAAAAAAAAAAAf39/ACUAAABYAAAAAAAAAAAAAAAAAAAAAAAAAAAAAAAAAAAAAAAAAAAAAAAAAAAAAAAAAAAAAAA/AAAAAAAAAKCGAQAAAAAAAAAAAAAAAAAMAAAAAQAAAAAAAAAAAAAAAAAAAB8AAABUAAAAAAAABQAAAAEAAAAAAAAAAAAAAAAAAAAAAAAAAAAAAAAAAAAAAAAAAAAAAAJ/f38AAAAAA8zMzADAwP8Af39/AAAAAAAAAAAAAAAAAAAAAAAAAAAAIQAAABgAAAAUAAAALCIAANkKAACPNQAAmCUAABAAAAAmAAAACAAAAD2wAAAAAAAA"/>
               </a:ext>
             </a:extLst>
           </p:cNvSpPr>
@@ -4442,7 +4318,7 @@
             <a:spLocks noGrp="1" noChangeArrowheads="1"/>
             <a:extLst>
               <a:ext uri="smNativeData">
-                <pr:smNativeData xmlns:pr="smNativeData" xmlns="smNativeData" val="SMDATA_15_EkJ5ZhMAAAAlAAAAZAAAAA0AAAAAkAAAAJAAAACQAAAAkAAAAAAAAAABAAAAAAAAAAEAAABQAAAAAAAAAAAA4D8AAAAAAADgPwAAAAAAAOA/AAAAAAAA4D8AAAAAAADgPwAAAAAAAOA/AAAAAAAA4D8AAAAAAADgPwAAAAAAAOA/AAAAAAAA4D8CAAAAjAAAAAAAAAAAAAAAQoX0DP///wgAAAAAAAAAAAAAAAAAAAAAAAAAAAAAAAAAAAAAZAAAAAEAAABAAAAAAAAAAAAAAAAAAAAAAAAAAAAAAAAAAAAAAAAAAAAAAAAAAAAAAAAAAAAAAAAAAAAAAAAAAAAAAAAAAAAAAAAAAAAAAAAAAAAAAAAAAAAAAAAAAAAAFAAAADwAAAAAAAAAAAAAAAAAAAkUAAAAAQAAABQAAAAUAAAAFAAAAAEAAAAAAAAAZAAAAGQAAAAAAAAAZAAAAGQAAAAVAAAAYAAAAAAAAAAAAAAADwAAACADAAAAAAAAAAAAAAEAAACgMgAAVgcAAKr4//8BAAAAf39/AAEAAABkAAAAAAAAABQAAABAHwAAAAAAACYAAAAAAAAAwOD//wAAAAAmAAAAZAAAABYAAABMAAAAAAAAAAAAAAAEAAAAAAAAAAEAAABZWVkKAAAAACgAAAAoAAAAZAAAAGQAAAAAAAAAzMzMAAAAAABQAAAAUAAAAGQAAABkAAAAAAAAABcAAAAUAAAAAAAAAAAAAAD/fwAA/38AAAAAAAAJAAAABAAAAAAAAAAeAAAAaAAAAAAAAAAAAAAAAAAAAAAAAAAAAAAAECcAABAnAAAAAAAAAAAAAAAAAAAAAAAAAAAAAAAAAAAAAAAAAAAAABQAAAAAAAAAwMD/AAAAAABkAAAAMgAAAAAAAABkAAAAAAAAAH9/fwAKAAAAIgAAABgAAAAAAAAAAAAAAAAAAAAAAAAAAAAAAAAAAAAkAAAAJAAAAAAAAAAHAAAAAAAAAAAAAAAAAAAAAAAAAAAAAAAAAAAAf39/ACUAAABYAAAAAAAAAAAAAAAAAAAAAAAAAAAAAAAAAAAAAAAAAAAAAAAAAAAAAAAAAAAAAAA/AAAAAAAAAKCGAQAAAAAAAAAAAAAAAAAMAAAAAQAAAAAAAAAAAAAAAAAAAB8AAABUAAAAAAAABQAAAAEAAAAAAAAAAAAAAAAAAAAAAAAAAAAAAAAAAAAAAAAAAAAAAAJ/f38AAAAAA8zMzADAwP8Af39/AAAAAAAAAAAAAAAAAAAAAAAAAAAAIQAAABgAAAAUAAAAFAMAAEoPAADlMwAAMhYAABAAAAAmAAAACAAAAL2wAAAAAAAA"/>
+                <pr:smNativeData xmlns:pr="smNativeData" xmlns="smNativeData" val="SMDATA_15_LkR5ZhMAAAAlAAAAZAAAAA0AAAAAkAAAAJAAAACQAAAAkAAAAAAAAAABAAAAAAAAAAEAAABQAAAAAAAAAAAA4D8AAAAAAADgPwAAAAAAAOA/AAAAAAAA4D8AAAAAAADgPwAAAAAAAOA/AAAAAAAA4D8AAAAAAADgPwAAAAAAAOA/AAAAAAAA4D8CAAAAjAAAAAAAAAAAAAAAQoX0DP///wgAAAAAAAAAAAAAAAAAAAAAAAAAAAAAAAAAAAAAZAAAAAEAAABAAAAAAAAAAAAAAAAAAAAAAAAAAAAAAAAAAAAAAAAAAAAAAAAAAAAAAAAAAAAAAAAAAAAAAAAAAAAAAAAAAAAAAAAAAAAAAAAAAAAAAAAAAAAAAAAAAAAAFAAAADwAAAAAAAAAAAAAAAAAAAkUAAAAAQAAABQAAAAUAAAAFAAAAAEAAAAAAAAAZAAAAGQAAAAAAAAAZAAAAGQAAAAVAAAAYAAAAAAAAAAAAAAADwAAACADAAAAAAAAAAAAAAEAAACgMgAAVgcAAKr4//8BAAAAf39/AAEAAABkAAAAAAAAABQAAABAHwAAAAAAACYAAAAAAAAAwOD//wAAAAAmAAAAZAAAABYAAABMAAAAAAAAAAAAAAAEAAAAAAAAAAEAAABZWVkKAAAAACgAAAAoAAAAZAAAAGQAAAAAAAAAzMzMAAAAAABQAAAAUAAAAGQAAABkAAAAAAAAABcAAAAUAAAAAAAAAAAAAAD/fwAA/38AAAAAAAAJAAAABAAAAAAAAAAeAAAAaAAAAAAAAAAAAAAAAAAAAAAAAAAAAAAAECcAABAnAAAAAAAAAAAAAAAAAAAAAAAAAAAAAAAAAAAAAAAAAAAAABQAAAAAAAAAwMD/AAAAAABkAAAAMgAAAAAAAABkAAAAAAAAAH9/fwAKAAAAIgAAABgAAAAAAAAAAAAAAAAAAAAAAAAAAAAAAAAAAAAkAAAAJAAAAAAAAAAHAAAAAAAAAAAAAAAAAAAAAAAAAAAAAAAAAAAAf39/ACUAAABYAAAAAAAAAAAAAAAAAAAAAAAAAAAAAAAAAAAAAAAAAAAAAAAAAAAAAAAAAAAAAAA/AAAAAAAAAKCGAQAAAAAAAAAAAAAAAAAMAAAAAQAAAAAAAAAAAAAAAAAAAB8AAABUAAAAAAAABQAAAAEAAAAAAAAAAAAAAAAAAAAAAAAAAAAAAAAAAAAAAAAAAAAAAAJ/f38AAAAAA8zMzADAwP8Af39/AAAAAAAAAAAAAAAAAAAAAAAAAAAAIQAAABgAAAAUAAAAFAMAAEoPAADlMwAAMhYAABAAAAAmAAAACAAAAL2wAAAAAAAA"/>
               </a:ext>
             </a:extLst>
           </p:cNvSpPr>
@@ -4566,7 +4442,7 @@
             <a:spLocks noGrp="1" noChangeArrowheads="1"/>
             <a:extLst>
               <a:ext uri="smNativeData">
-                <pr:smNativeData xmlns:pr="smNativeData" xmlns="smNativeData" val="SMDATA_15_EkJ5ZhMAAAAlAAAAZAAAAA0AAAAAkAAAAJAAAACQAAAAkAAAAAAAAAABAAAAAAAAAAEAAABQAAAAAAAAAAAA4D8AAAAAAADgPwAAAAAAAOA/AAAAAAAA4D8AAAAAAADgPwAAAAAAAOA/AAAAAAAA4D8AAAAAAADgPwAAAAAAAOA/AAAAAAAA4D8CAAAAjAAAAAAAAAAAAAAAQoX0DP///wgAAAAAAAAAAAAAAAAAAAAAAAAAAAAAAAAAAAAAZAAAAAEAAABAAAAAAAAAAAAAAAAAAAAAAAAAAAAAAAAAAAAAAAAAAAAAAAAAAAAAAAAAAAAAAAAAAAAAAAAAAAAAAAAAAAAAAAAAAAAAAAAAAAAAAAAAAAAAAAAAAAAAFAAAADwAAAAAAAAAAAAAAAAAAAkUAAAAAQAAABQAAAAUAAAAFAAAAAEAAAAAAAAAZAAAAGQAAAAAAAAAZAAAAGQAAAAVAAAAYAAAAAAAAAAAAAAADwAAACADAAAAAAAAAAAAAAEAAACgMgAAVgcAAKr4//8BAAAAf39/AAEAAABkAAAAAAAAABQAAABAHwAAAAAAACYAAAAAAAAAwOD//wAAAAAmAAAAZAAAABYAAABMAAAAAAAAAAAAAAAEAAAAAAAAAAEAAABZWVkKAAAAACgAAAAoAAAAZAAAAGQAAAAAAAAAzMzMAAAAAABQAAAAUAAAAGQAAABkAAAAAAAAABcAAAAUAAAAAAAAAAAAAAD/fwAA/38AAAAAAAAJAAAABAAAAAAAAAAeAAAAaAAAAAAAAAAAAAAAAAAAAAAAAAAAAAAAECcAABAnAAAAAAAAAAAAAAAAAAAAAAAAAAAAAAAAAAAAAAAAAAAAABQAAAAAAAAAwMD/AAAAAABkAAAAMgAAAAAAAABkAAAAAAAAAH9/fwAKAAAAIgAAABgAAAAAAAAAAAAAAAAAAAAAAAAAAAAAAAAAAAAkAAAAJAAAAAAAAAAHAAAAAAAAAAAAAAAAAAAAAAAAAAAAAAAAAAAAf39/ACUAAABYAAAAAAAAAAAAAAAAAAAAAAAAAAAAAAAAAAAAAAAAAAAAAAAAAAAAAAAAAAAAAAA/AAAAAAAAAKCGAQAAAAAAAAAAAAAAAAAMAAAAAQAAAAAAAAAAAAAAAAAAAB8AAABUAAAAAAAABQAAAAEAAAAAAAAAAAAAAAAAAAAAAAAAAAAAAAAAAAAAAAAAAAAAAAJ/f38AAAAAA8zMzADAwP8Af39/AAAAAAAAAAAAAAAAAAAAAAAAAAAAIQAAABgAAAAUAAAAHjQAAEAmAAB/NwAAeikAABAAAAAmAAAACAAAADywAAAAAAAA"/>
+                <pr:smNativeData xmlns:pr="smNativeData" xmlns="smNativeData" val="SMDATA_15_LkR5ZhMAAAAlAAAAZAAAAA0AAAAAkAAAAJAAAACQAAAAkAAAAAAAAAABAAAAAAAAAAEAAABQAAAAAAAAAAAA4D8AAAAAAADgPwAAAAAAAOA/AAAAAAAA4D8AAAAAAADgPwAAAAAAAOA/AAAAAAAA4D8AAAAAAADgPwAAAAAAAOA/AAAAAAAA4D8CAAAAjAAAAAAAAAAAAAAAQoX0DP///wgAAAAAAAAAAAAAAAAAAAAAAAAAAAAAAAAAAAAAZAAAAAEAAABAAAAAAAAAAAAAAAAAAAAAAAAAAAAAAAAAAAAAAAAAAAAAAAAAAAAAAAAAAAAAAAAAAAAAAAAAAAAAAAAAAAAAAAAAAAAAAAAAAAAAAAAAAAAAAAAAAAAAFAAAADwAAAAAAAAAAAAAAAAAAAkUAAAAAQAAABQAAAAUAAAAFAAAAAEAAAAAAAAAZAAAAGQAAAAAAAAAZAAAAGQAAAAVAAAAYAAAAAAAAAAAAAAADwAAACADAAAAAAAAAAAAAAEAAACgMgAAVgcAAKr4//8BAAAAf39/AAEAAABkAAAAAAAAABQAAABAHwAAAAAAACYAAAAAAAAAwOD//wAAAAAmAAAAZAAAABYAAABMAAAAAAAAAAAAAAAEAAAAAAAAAAEAAABZWVkKAAAAACgAAAAoAAAAZAAAAGQAAAAAAAAAzMzMAAAAAABQAAAAUAAAAGQAAABkAAAAAAAAABcAAAAUAAAAAAAAAAAAAAD/fwAA/38AAAAAAAAJAAAABAAAAAAAAAAeAAAAaAAAAAAAAAAAAAAAAAAAAAAAAAAAAAAAECcAABAnAAAAAAAAAAAAAAAAAAAAAAAAAAAAAAAAAAAAAAAAAAAAABQAAAAAAAAAwMD/AAAAAABkAAAAMgAAAAAAAABkAAAAAAAAAH9/fwAKAAAAIgAAABgAAAAAAAAAAAAAAAAAAAAAAAAAAAAAAAAAAAAkAAAAJAAAAAAAAAAHAAAAAAAAAAAAAAAAAAAAAAAAAAAAAAAAAAAAf39/ACUAAABYAAAAAAAAAAAAAAAAAAAAAAAAAAAAAAAAAAAAAAAAAAAAAAAAAAAAAAAAAAAAAAA/AAAAAAAAAKCGAQAAAAAAAAAAAAAAAAAMAAAAAQAAAAAAAAAAAAAAAAAAAB8AAABUAAAAAAAABQAAAAEAAAAAAAAAAAAAAAAAAAAAAAAAAAAAAAAAAAAAAAAAAAAAAAJ/f38AAAAAA8zMzADAwP8Af39/AAAAAAAAAAAAAAAAAAAAAAAAAAAAIQAAABgAAAAUAAAAHjQAAEAmAAB/NwAAeikAABAAAAAmAAAACAAAADywAAAAAAAA"/>
               </a:ext>
             </a:extLst>
           </p:cNvSpPr>
@@ -4620,10 +4496,11 @@
               </a:spcAft>
               <a:buNone/>
             </a:pPr>
-            <a:fld id="{3FC22B28-66D2-97DD-9C7A-908865346AC5}" type="slidenum">
+            <a:fld id="{3FDAAAA4-EAD2-8F5C-9C62-1C09E42C6A49}" type="slidenum">
               <a:rPr lang="ru-ru" cap="none"/>
               <a:t/>
             </a:fld>
+            <a:endParaRPr lang="ru-ru" cap="none"/>
           </a:p>
         </p:txBody>
       </p:sp>
@@ -4660,7 +4537,7 @@
             <a:spLocks noGrp="1" noChangeArrowheads="1"/>
             <a:extLst>
               <a:ext uri="smNativeData">
-                <pr:smNativeData xmlns:pr="smNativeData" xmlns="smNativeData" val="SMDATA_15_EkJ5ZhMAAAAlAAAAZAAAAA0AAAAAkAAAAJAAAACQAAAAkAAAAAAAAAAAAAAAAAAAAAEAAABQAAAAAAAAAAAA4D8AAAAAAADgPwAAAAAAAOA/AAAAAAAA4D8AAAAAAADgPwAAAAAAAOA/AAAAAAAA4D8AAAAAAADgPwAAAAAAAOA/AAAAAAAA4D8CAAAAjAAAAAAAAAAAAAAAQoX0DP///wgAAAAAAAAAAAAAAAAAAAAAAAAAAAAAAAAAAAAAZAAAAAEAAABAAAAAAAAAAAAAAAAAAAAAAAAAAAAAAAAAAAAAAAAAAAAAAAAAAAAAAAAAAAAAAAAAAAAAAAAAAAAAAAAAAAAAAAAAAAAAAAAAAAAAAAAAAAAAAAAAAAAAFAAAADwAAAAAAAAAAAAAAAAAAAkUAAAAAQAAABQAAAAUAAAAFAAAAAEAAAAAAAAAZAAAAGQAAAAAAAAAZAAAAGQAAAAVAAAAYAAAAAAAAAAAAAAADwAAACADAAAAAAAAAAAAAAEAAACgMgAAVgcAAKr4//8BAAAAf39/AAEAAABkAAAAAAAAABQAAABAHwAAAAAAACYAAAAAAAAAwOD//wAAAAAmAAAAZAAAABYAAABMAAAAAAAAAAAAAAAEAAAAAAAAAAEAAABZWVkKAAAAACgAAAAoAAAAZAAAAGQAAAAAAAAAzMzMAAAAAABQAAAAUAAAAGQAAABkAAAAAAAAABcAAAAUAAAAAAAAAAAAAAD/fwAA/38AAAAAAAAJAAAABAAAAMhrcwceAAAAaAAAAAAAAAAAAAAAAAAAAAAAAAAAAAAAECcAABAnAAAAAAAAAAAAAAAAAAAAAAAAAAAAAAAAAAAAAAAAAAAAABQAAAAAAAAAwMD/AAAAAABkAAAAMgAAAAAAAABkAAAAAAAAAH9/fwAKAAAAIgAAABgAAAAAAAAAAAAAAAAAAAAAAAAAAAAAAAAAAAAkAAAAJAAAAAAAAAAHAAAAAAAAAAAAAAAAAAAAAAAAAAAAAAAAAAAAf39/ACUAAABYAAAAAAAAAAAAAAAAAAAAAAAAAAAAAAAAAAAAAAAAAAAAAAAAAAAAAAAAAAAAAAA/AAAAAAAAAKCGAQAAAAAAAAAAAAAAAAAMAAAAAQAAAAAAAAAAAAAAAAAAAB8AAABUAAAAAAAABQAAAAEAAAAAAAAAAAAAAAAAAAAAAAAAAAAAAAAAAAAAAAAAAAAAAAJ/f38AAAAAA8zMzADAwP8Af39/AAAAAAAAAAAAAAAAAAAAAAAAAAAAIQAAABgAAAAUAAAAFAMAALYCAAB/NwAAvwoAABAAAAAmAAAACAAAADywAAAAAAAA"/>
+                <pr:smNativeData xmlns:pr="smNativeData" xmlns="smNativeData" val="SMDATA_15_LkR5ZhMAAAAlAAAAZAAAAA0AAAAAkAAAAJAAAACQAAAAkAAAAAAAAAAAAAAAAAAAAAEAAABQAAAAAAAAAAAA4D8AAAAAAADgPwAAAAAAAOA/AAAAAAAA4D8AAAAAAADgPwAAAAAAAOA/AAAAAAAA4D8AAAAAAADgPwAAAAAAAOA/AAAAAAAA4D8CAAAAjAAAAAAAAAAAAAAAQoX0DP///wgAAAAAAAAAAAAAAAAAAAAAAAAAAAAAAAAAAAAAZAAAAAEAAABAAAAAAAAAAAAAAAAAAAAAAAAAAAAAAAAAAAAAAAAAAAAAAAAAAAAAAAAAAAAAAAAAAAAAAAAAAAAAAAAAAAAAAAAAAAAAAAAAAAAAAAAAAAAAAAAAAAAAFAAAADwAAAAAAAAAAAAAAAAAAAkUAAAAAQAAABQAAAAUAAAAFAAAAAEAAAAAAAAAZAAAAGQAAAAAAAAAZAAAAGQAAAAVAAAAYAAAAAAAAAAAAAAADwAAACADAAAAAAAAAAAAAAEAAACgMgAAVgcAAKr4//8BAAAAf39/AAEAAABkAAAAAAAAABQAAABAHwAAAAAAACYAAAAAAAAAwOD//wAAAAAmAAAAZAAAABYAAABMAAAAAAAAAAAAAAAEAAAAAAAAAAEAAABZWVkKAAAAACgAAAAoAAAAZAAAAGQAAAAAAAAAzMzMAAAAAABQAAAAUAAAAGQAAABkAAAAAAAAABcAAAAUAAAAAAAAAAAAAAD/fwAA/38AAAAAAAAJAAAABAAAAMhrcwceAAAAaAAAAAAAAAAAAAAAAAAAAAAAAAAAAAAAECcAABAnAAAAAAAAAAAAAAAAAAAAAAAAAAAAAAAAAAAAAAAAAAAAABQAAAAAAAAAwMD/AAAAAABkAAAAMgAAAAAAAABkAAAAAAAAAH9/fwAKAAAAIgAAABgAAAAAAAAAAAAAAAAAAAAAAAAAAAAAAAAAAAAkAAAAJAAAAAAAAAAHAAAAAAAAAAAAAAAAAAAAAAAAAAAAAAAAAAAAf39/ACUAAABYAAAAAAAAAAAAAAAAAAAAAAAAAAAAAAAAAAAAAAAAAAAAAAAAAAAAAAAAAAAAAAA/AAAAAAAAAKCGAQAAAAAAAAAAAAAAAAAMAAAAAQAAAAAAAAAAAAAAAAAAAB8AAABUAAAAAAAABQAAAAEAAAAAAAAAAAAAAAAAAAAAAAAAAAAAAAAAAAAAAAAAAAAAAAJ/f38AAAAAA8zMzADAwP8Af39/AAAAAAAAAAAAAAAAAAAAAAAAAAAAIQAAABgAAAAUAAAAFAMAALYCAAB/NwAAvwoAABAAAAAmAAAACAAAADywAAAAAAAA"/>
               </a:ext>
             </a:extLst>
           </p:cNvSpPr>
@@ -4770,7 +4647,7 @@
             <a:spLocks noGrp="1" noChangeArrowheads="1"/>
             <a:extLst>
               <a:ext uri="smNativeData">
-                <pr:smNativeData xmlns:pr="smNativeData" xmlns="smNativeData" val="SMDATA_15_EkJ5ZhMAAAAlAAAAZAAAAA0AAAAAkAAAAJAAAACQAAAAkAAAAAAAAAAAAAAAAAAAAAEAAABQAAAAAAAAAAAA4D8AAAAAAADgPwAAAAAAAOA/AAAAAAAA4D8AAAAAAADgPwAAAAAAAOA/AAAAAAAA4D8AAAAAAADgPwAAAAAAAOA/AAAAAAAA4D8CAAAAjAAAAAAAAAAAAAAAQoX0DP///wgAAAAAAAAAAAAAAAAAAAAAAAAAAAAAAAAAAAAAZAAAAAEAAABAAAAAAAAAAAAAAAAAAAAAAAAAAAAAAAAAAAAAAAAAAAAAAAAAAAAAAAAAAAAAAAAAAAAAAAAAAAAAAAAAAAAAAAAAAAAAAAAAAAAAAAAAAAAAAAAAAAAAFAAAADwAAAAAAAAAAAAAAAAAAAkUAAAAAQAAABQAAAAUAAAAFAAAAAEAAAAAAAAAZAAAAGQAAAAAAAAAZAAAAGQAAAAVAAAAYAAAAAAAAAAAAAAADwAAACADAAAAAAAAAAAAAAEAAACgMgAAVgcAAKr4//8BAAAAf39/AAEAAABkAAAAAAAAABQAAABAHwAAAAAAACYAAAAAAAAAwOD//wAAAAAmAAAAZAAAABYAAABMAAAAAAAAAAAAAAAEAAAAAAAAAAEAAABZWVkKAAAAACgAAAAoAAAAZAAAAGQAAAAAAAAAzMzMAAAAAABQAAAAUAAAAGQAAABkAAAAAAAAABcAAAAUAAAAAAAAAAAAAAD/fwAA/38AAAAAAAAJAAAABAAAAF8AYAAeAAAAaAAAAAAAAAAAAAAAAAAAAAAAAAAAAAAAECcAABAnAAAAAAAAAAAAAAAAAAAAAAAAAAAAAAAAAAAAAAAAAAAAABQAAAAAAAAAwMD/AAAAAABkAAAAMgAAAAAAAABkAAAAAAAAAH9/fwAKAAAAIgAAABgAAAAAAAAAAAAAAAAAAAAAAAAAAAAAAAAAAAAkAAAAJAAAAAAAAAAHAAAAAAAAAAAAAAAAAAAAAAAAAAAAAAAAAAAAf39/ACUAAABYAAAAAAAAAAAAAAAAAAAAAAAAAAAAAAAAAAAAAAAAAAAAAAAAAAAAAAAAAAAAAAA/AAAAAAAAAKCGAQAAAAAAAAAAAAAAAAAMAAAAAQAAAAAAAAAAAAAAAAAAAB8AAABUAAAAAAAABQAAAAEAAAAAAAAAAAAAAAAAAAAAAAAAAAAAAAAAAAAAAAAAAAAAAAJ/f38AAAAAA8zMzADAwP8Af39/AAAAAAAAAAAAAAAAAAAAAAAAAAAAIQAAABgAAAAUAAAAFAMAALMLAAB/NwAAuScAABAAAAAmAAAACAAAAD2wAAAAAAAA"/>
+                <pr:smNativeData xmlns:pr="smNativeData" xmlns="smNativeData" val="SMDATA_15_LkR5ZhMAAAAlAAAAZAAAAA0AAAAAkAAAAJAAAACQAAAAkAAAAAAAAAAAAAAAAAAAAAEAAABQAAAAAAAAAAAA4D8AAAAAAADgPwAAAAAAAOA/AAAAAAAA4D8AAAAAAADgPwAAAAAAAOA/AAAAAAAA4D8AAAAAAADgPwAAAAAAAOA/AAAAAAAA4D8CAAAAjAAAAAAAAAAAAAAAQoX0DP///wgAAAAAAAAAAAAAAAAAAAAAAAAAAAAAAAAAAAAAZAAAAAEAAABAAAAAAAAAAAAAAAAAAAAAAAAAAAAAAAAAAAAAAAAAAAAAAAAAAAAAAAAAAAAAAAAAAAAAAAAAAAAAAAAAAAAAAAAAAAAAAAAAAAAAAAAAAAAAAAAAAAAAFAAAADwAAAAAAAAAAAAAAAAAAAkUAAAAAQAAABQAAAAUAAAAFAAAAAEAAAAAAAAAZAAAAGQAAAAAAAAAZAAAAGQAAAAVAAAAYAAAAAAAAAAAAAAADwAAACADAAAAAAAAAAAAAAEAAACgMgAAVgcAAKr4//8BAAAAf39/AAEAAABkAAAAAAAAABQAAABAHwAAAAAAACYAAAAAAAAAwOD//wAAAAAmAAAAZAAAABYAAABMAAAAAAAAAAAAAAAEAAAAAAAAAAEAAABZWVkKAAAAACgAAAAoAAAAZAAAAGQAAAAAAAAAzMzMAAAAAABQAAAAUAAAAGQAAABkAAAAAAAAABcAAAAUAAAAAAAAAAAAAAD/fwAA/38AAAAAAAAJAAAABAAAAF8AYAAeAAAAaAAAAAAAAAAAAAAAAAAAAAAAAAAAAAAAECcAABAnAAAAAAAAAAAAAAAAAAAAAAAAAAAAAAAAAAAAAAAAAAAAABQAAAAAAAAAwMD/AAAAAABkAAAAMgAAAAAAAABkAAAAAAAAAH9/fwAKAAAAIgAAABgAAAAAAAAAAAAAAAAAAAAAAAAAAAAAAAAAAAAkAAAAJAAAAAAAAAAHAAAAAAAAAAAAAAAAAAAAAAAAAAAAAAAAAAAAf39/ACUAAABYAAAAAAAAAAAAAAAAAAAAAAAAAAAAAAAAAAAAAAAAAAAAAAAAAAAAAAAAAAAAAAA/AAAAAAAAAKCGAQAAAAAAAAAAAAAAAAAMAAAAAQAAAAAAAAAAAAAAAAAAAB8AAABUAAAAAAAABQAAAAEAAAAAAAAAAAAAAAAAAAAAAAAAAAAAAAAAAAAAAAAAAAAAAAJ/f38AAAAAA8zMzADAwP8Af39/AAAAAAAAAAAAAAAAAAAAAAAAAAAAIQAAABgAAAAUAAAAFAMAALMLAAB/NwAAuScAABAAAAAmAAAACAAAAD2wAAAAAAAA"/>
               </a:ext>
             </a:extLst>
           </p:cNvSpPr>
@@ -4921,7 +4798,7 @@
             <a:spLocks noGrp="1" noChangeArrowheads="1"/>
             <a:extLst>
               <a:ext uri="smNativeData">
-                <pr:smNativeData xmlns:pr="smNativeData" xmlns="smNativeData" val="SMDATA_15_EkJ5ZhMAAAAlAAAAZAAAAA0AAAAAkAAAAJAAAACQAAAAkAAAAAAAAAABAAAAAAAAAAEAAABQAAAAAAAAAAAA4D8AAAAAAADgPwAAAAAAAOA/AAAAAAAA4D8AAAAAAADgPwAAAAAAAOA/AAAAAAAA4D8AAAAAAADgPwAAAAAAAOA/AAAAAAAA4D8CAAAAjAAAAAAAAAAAAAAAQoX0DP///wgAAAAAAAAAAAAAAAAAAAAAAAAAAAAAAAAAAAAAZAAAAAEAAABAAAAAAAAAAAAAAAAAAAAAAAAAAAAAAAAAAAAAAAAAAAAAAAAAAAAAAAAAAAAAAAAAAAAAAAAAAAAAAAAAAAAAAAAAAAAAAAAAAAAAAAAAAAAAAAAAAAAAFAAAADwAAAAAAAAAAAAAAAAAAAkUAAAAAQAAABQAAAAUAAAAFAAAAAEAAAAAAAAAZAAAAGQAAAAAAAAAZAAAAGQAAAAVAAAAYAAAAAAAAAAAAAAADwAAACADAAAAAAAAAAAAAAEAAACgMgAAVgcAAKr4//8BAAAAf39/AAEAAABkAAAAAAAAABQAAABAHwAAAAAAACYAAAAAAAAAwOD//wAAAAAmAAAAZAAAABYAAABMAAAAAAAAAAAAAAAEAAAAAAAAAAEAAABZWVkKAAAAACgAAAAoAAAAZAAAAGQAAAAAAAAAzMzMAAAAAABQAAAAUAAAAGQAAABkAAAAAAAAABcAAAAUAAAAAAAAAAAAAAD/fwAA/38AAAAAAAAJAAAABAAAAF8AYAAeAAAAaAAAAAAAAAAAAAAAAAAAAAAAAAAAAAAAECcAABAnAAAAAAAAAAAAAAAAAAAAAAAAAAAAAAAAAAAAAAAAAAAAABQAAAAAAAAAwMD/AAAAAABkAAAAMgAAAAAAAABkAAAAAAAAAH9/fwAKAAAAIgAAABgAAAAAAAAAAAAAAAAAAAAAAAAAAAAAAAAAAAAkAAAAJAAAAAAAAAAHAAAAAAAAAAAAAAAAAAAAAAAAAAAAAAAAAAAAf39/ACUAAABYAAAAAAAAAAAAAAAAAAAAAAAAAAAAAAAAAAAAAAAAAAAAAAAAAAAAAAAAAAAAAAA/AAAAAAAAAKCGAQAAAAAAAAAAAAAAAAAMAAAAAQAAAAAAAAAAAAAAAAAAAB8AAABUAAAAAAAABQAAAAEAAAAAAAAAAAAAAAAAAAAAAAAAAAAAAAAAAAAAAAAAAAAAAAJ/f38AAAAAA8zMzADAwP8Af39/AAAAAAAAAAAAAAAAAAAAAAAAAAAAIQAAABgAAAAUAAAAHjQAAEAmAAB/NwAAeikAABAAAAAmAAAACAAAADywAAAAAAAA"/>
+                <pr:smNativeData xmlns:pr="smNativeData" xmlns="smNativeData" val="SMDATA_15_LkR5ZhMAAAAlAAAAZAAAAA0AAAAAkAAAAJAAAACQAAAAkAAAAAAAAAABAAAAAAAAAAEAAABQAAAAAAAAAAAA4D8AAAAAAADgPwAAAAAAAOA/AAAAAAAA4D8AAAAAAADgPwAAAAAAAOA/AAAAAAAA4D8AAAAAAADgPwAAAAAAAOA/AAAAAAAA4D8CAAAAjAAAAAAAAAAAAAAAQoX0DP///wgAAAAAAAAAAAAAAAAAAAAAAAAAAAAAAAAAAAAAZAAAAAEAAABAAAAAAAAAAAAAAAAAAAAAAAAAAAAAAAAAAAAAAAAAAAAAAAAAAAAAAAAAAAAAAAAAAAAAAAAAAAAAAAAAAAAAAAAAAAAAAAAAAAAAAAAAAAAAAAAAAAAAFAAAADwAAAAAAAAAAAAAAAAAAAkUAAAAAQAAABQAAAAUAAAAFAAAAAEAAAAAAAAAZAAAAGQAAAAAAAAAZAAAAGQAAAAVAAAAYAAAAAAAAAAAAAAADwAAACADAAAAAAAAAAAAAAEAAACgMgAAVgcAAKr4//8BAAAAf39/AAEAAABkAAAAAAAAABQAAABAHwAAAAAAACYAAAAAAAAAwOD//wAAAAAmAAAAZAAAABYAAABMAAAAAAAAAAAAAAAEAAAAAAAAAAEAAABZWVkKAAAAACgAAAAoAAAAZAAAAGQAAAAAAAAAzMzMAAAAAABQAAAAUAAAAGQAAABkAAAAAAAAABcAAAAUAAAAAAAAAAAAAAD/fwAA/38AAAAAAAAJAAAABAAAAF8AYAAeAAAAaAAAAAAAAAAAAAAAAAAAAAAAAAAAAAAAECcAABAnAAAAAAAAAAAAAAAAAAAAAAAAAAAAAAAAAAAAAAAAAAAAABQAAAAAAAAAwMD/AAAAAABkAAAAMgAAAAAAAABkAAAAAAAAAH9/fwAKAAAAIgAAABgAAAAAAAAAAAAAAAAAAAAAAAAAAAAAAAAAAAAkAAAAJAAAAAAAAAAHAAAAAAAAAAAAAAAAAAAAAAAAAAAAAAAAAAAAf39/ACUAAABYAAAAAAAAAAAAAAAAAAAAAAAAAAAAAAAAAAAAAAAAAAAAAAAAAAAAAAAAAAAAAAA/AAAAAAAAAKCGAQAAAAAAAAAAAAAAAAAMAAAAAQAAAAAAAAAAAAAAAAAAAB8AAABUAAAAAAAABQAAAAEAAAAAAAAAAAAAAAAAAAAAAAAAAAAAAAAAAAAAAAAAAAAAAAJ/f38AAAAAA8zMzADAwP8Af39/AAAAAAAAAAAAAAAAAAAAAAAAAAAAIQAAABgAAAAUAAAAHjQAAEAmAAB/NwAAeikAABAAAAAmAAAACAAAADywAAAAAAAA"/>
               </a:ext>
             </a:extLst>
           </p:cNvSpPr>
@@ -4975,10 +4852,11 @@
               </a:spcAft>
               <a:buNone/>
             </a:pPr>
-            <a:fld id="{3FC27E29-67D2-9788-9C7A-91DD30346AC4}" type="slidenum">
+            <a:fld id="{3FDAC551-1FD2-8F33-9C62-E9668B2C6ABC}" type="slidenum">
               <a:rPr lang="ru-ru" cap="none"/>
               <a:t/>
             </a:fld>
+            <a:endParaRPr lang="ru-ru" cap="none"/>
           </a:p>
         </p:txBody>
       </p:sp>
@@ -5015,7 +4893,7 @@
             <a:spLocks noGrp="1" noChangeArrowheads="1"/>
             <a:extLst>
               <a:ext uri="smNativeData">
-                <pr:smNativeData xmlns:pr="smNativeData" xmlns="smNativeData" val="SMDATA_15_EkJ5ZhMAAAAlAAAAZAAAAA0AAAAAkAAAAJAAAACQAAAAkAAAAAAAAAABAAAAAAAAAAEAAABQAAAAAAAAAAAA4D8AAAAAAADgPwAAAAAAAOA/AAAAAAAA4D8AAAAAAADgPwAAAAAAAOA/AAAAAAAA4D8AAAAAAADgPwAAAAAAAOA/AAAAAAAA4D8CAAAAjAAAAAAAAAAAAAAAQoX0DP///wgAAAAAAAAAAAAAAAAAAAAAAAAAAAAAAAAAAAAAZAAAAAEAAABAAAAAAAAAAAAAAAAAAAAAAAAAAAAAAAAAAAAAAAAAAAAAAAAAAAAAAAAAAAAAAAAAAAAAAAAAAAAAAAAAAAAAAAAAAAAAAAAAAAAAAAAAAAAAAAAAAAAAFAAAADwAAAAAAAAAAAAAAAAAAAkUAAAAAQAAABQAAAAUAAAAFAAAAAEAAAAAAAAAZAAAAGQAAAAAAAAAZAAAAGQAAAAVAAAAYAAAAAAAAAAAAAAADwAAACADAAAAAAAAAAAAAAEAAACgMgAAVgcAAKr4//8BAAAAf39/AAEAAABkAAAAAAAAABQAAABAHwAAAAAAACYAAAAAAAAAwOD//wAAAAAmAAAAZAAAABYAAABMAAAAAAAAAAAAAAAEAAAAAAAAAAEAAABZWVkKAAAAACgAAAAoAAAAZAAAAGQAAAAAAAAAzMzMAAAAAABQAAAAUAAAAGQAAABkAAAAAAAAABcAAAAUAAAAAAAAAAAAAAD/fwAA/38AAAAAAAAJAAAABAAAAAAAAAAeAAAAaAAAAAAAAAAAAAAAAAAAAAAAAAAAAAAAECcAABAnAAAAAAAAAAAAAAAAAAAAAAAAAAAAAAAAAAAAAAAAAAAAABQAAAAAAAAAwMD/AAAAAABkAAAAMgAAAAAAAABkAAAAAAAAAH9/fwAKAAAAIgAAABgAAAAAAAAAAAAAAAAAAAAAAAAAAAAAAAAAAAAkAAAAJAAAAAAAAAAHAAAAAAAAAAAAAAAAAAAAAAAAAAAAAAAAAAAAf39/ACUAAABYAAAAAAAAAAAAAAAAAAAAAAAAAAAAAAAAAAAAAAAAAAAAAAAAAAAAAAAAAAAAAAA/AAAAAAAAAKCGAQAAAAAAAAAAAAAAAAAMAAAAAQAAAAAAAAAAAAAAAAAAAB8AAABUAAAAAAAABQAAAAEAAAAAAAAAAAAAAAAAAAAAAAAAAAAAAAAAAAAAAAAAAAAAAAJ/f38AAAAAA8zMzADAwP8Af39/AAAAAAAAAAAAAAAAAAAAAAAAAAAAIQAAABgAAAAUAAAAHjQAAEAmAAB/NwAAeikAABAAAAAmAAAACAAAADywAAAAAAAA"/>
+                <pr:smNativeData xmlns:pr="smNativeData" xmlns="smNativeData" val="SMDATA_15_LkR5ZhMAAAAlAAAAZAAAAA0AAAAAkAAAAJAAAACQAAAAkAAAAAAAAAABAAAAAAAAAAEAAABQAAAAAAAAAAAA4D8AAAAAAADgPwAAAAAAAOA/AAAAAAAA4D8AAAAAAADgPwAAAAAAAOA/AAAAAAAA4D8AAAAAAADgPwAAAAAAAOA/AAAAAAAA4D8CAAAAjAAAAAAAAAAAAAAAQoX0DP///wgAAAAAAAAAAAAAAAAAAAAAAAAAAAAAAAAAAAAAZAAAAAEAAABAAAAAAAAAAAAAAAAAAAAAAAAAAAAAAAAAAAAAAAAAAAAAAAAAAAAAAAAAAAAAAAAAAAAAAAAAAAAAAAAAAAAAAAAAAAAAAAAAAAAAAAAAAAAAAAAAAAAAFAAAADwAAAAAAAAAAAAAAAAAAAkUAAAAAQAAABQAAAAUAAAAFAAAAAEAAAAAAAAAZAAAAGQAAAAAAAAAZAAAAGQAAAAVAAAAYAAAAAAAAAAAAAAADwAAACADAAAAAAAAAAAAAAEAAACgMgAAVgcAAKr4//8BAAAAf39/AAEAAABkAAAAAAAAABQAAABAHwAAAAAAACYAAAAAAAAAwOD//wAAAAAmAAAAZAAAABYAAABMAAAAAAAAAAAAAAAEAAAAAAAAAAEAAABZWVkKAAAAACgAAAAoAAAAZAAAAGQAAAAAAAAAzMzMAAAAAABQAAAAUAAAAGQAAABkAAAAAAAAABcAAAAUAAAAAAAAAAAAAAD/fwAA/38AAAAAAAAJAAAABAAAAAAAAAAeAAAAaAAAAAAAAAAAAAAAAAAAAAAAAAAAAAAAECcAABAnAAAAAAAAAAAAAAAAAAAAAAAAAAAAAAAAAAAAAAAAAAAAABQAAAAAAAAAwMD/AAAAAABkAAAAMgAAAAAAAABkAAAAAAAAAH9/fwAKAAAAIgAAABgAAAAAAAAAAAAAAAAAAAAAAAAAAAAAAAAAAAAkAAAAJAAAAAAAAAAHAAAAAAAAAAAAAAAAAAAAAAAAAAAAAAAAAAAAf39/ACUAAABYAAAAAAAAAAAAAAAAAAAAAAAAAAAAAAAAAAAAAAAAAAAAAAAAAAAAAAAAAAAAAAA/AAAAAAAAAKCGAQAAAAAAAAAAAAAAAAAMAAAAAQAAAAAAAAAAAAAAAAAAAB8AAABUAAAAAAAABQAAAAEAAAAAAAAAAAAAAAAAAAAAAAAAAAAAAAAAAAAAAAAAAAAAAAJ/f38AAAAAA8zMzADAwP8Af39/AAAAAAAAAAAAAAAAAAAAAAAAAAAAIQAAABgAAAAUAAAAHjQAAEAmAAB/NwAAeikAABAAAAAmAAAACAAAADywAAAAAAAA"/>
               </a:ext>
             </a:extLst>
           </p:cNvSpPr>
@@ -5069,10 +4947,11 @@
               </a:spcAft>
               <a:buNone/>
             </a:pPr>
-            <a:fld id="{3FC24EEB-A5D2-97B8-9C7A-53ED00346A06}" type="slidenum">
+            <a:fld id="{3FDAC90C-42D2-8F3F-9C62-B46A872C6AE1}" type="slidenum">
               <a:rPr lang="ru-ru" cap="none"/>
               <a:t/>
             </a:fld>
+            <a:endParaRPr lang="ru-ru" cap="none"/>
           </a:p>
         </p:txBody>
       </p:sp>
@@ -5083,7 +4962,7 @@
             <a:spLocks noGrp="1" noChangeArrowheads="1"/>
             <a:extLst>
               <a:ext uri="smNativeData">
-                <pr:smNativeData xmlns:pr="smNativeData" xmlns="smNativeData" val="SMDATA_15_EkJ5ZhMAAAAlAAAAZAAAAA0AAAAAkAAAAJAAAACQAAAAkAAAAAAAAAAAAAAAAAAAAAEAAABQAAAAAAAAAAAA4D8AAAAAAADgPwAAAAAAAOA/AAAAAAAA4D8AAAAAAADgPwAAAAAAAOA/AAAAAAAA4D8AAAAAAADgPwAAAAAAAOA/AAAAAAAA4D8CAAAAjAAAAAAAAAAAAAAAQoX0DP///wgAAAAAAAAAAAAAAAAAAAAAAAAAAAAAAAAAAAAAZAAAAAEAAABAAAAAAAAAAAAAAAAAAAAAAAAAAAAAAAAAAAAAAAAAAAAAAAAAAAAAAAAAAAAAAAAAAAAAAAAAAAAAAAAAAAAAAAAAAAAAAAAAAAAAAAAAAAAAAAAAAAAAFAAAADwAAAAAAAAAAAAAAAAAAAkUAAAAAQAAABQAAAAUAAAAFAAAAAEAAAAAAAAAZAAAAGQAAAAAAAAAZAAAAGQAAAAVAAAAYAAAAAAAAAAAAAAADwAAACADAAAAAAAAAAAAAAEAAACgMgAAVgcAAKr4//8BAAAAf39/AAEAAABkAAAAAAAAABQAAABAHwAAAAAAACYAAAAAAAAAwOD//wAAAAAmAAAAZAAAABYAAABMAAAAAAAAAAAAAAAEAAAAAAAAAAEAAABZWVkKAAAAACgAAAAoAAAAZAAAAGQAAAAAAAAAzMzMAAAAAABQAAAAUAAAAGQAAABkAAAAAAAAABcAAAAUAAAAAAAAAAAAAAD/fwAA/38AAAAAAAAJAAAABAAAAF0AXgAeAAAAaAAAAAAAAAAAAAAAAAAAAAAAAAAAAAAAECcAABAnAAAAAAAAAAAAAAAAAAAAAAAAAAAAAAAAAAAAAAAAAAAAABQAAAAAAAAAwMD/AAAAAABkAAAAMgAAAAAAAABkAAAAAAAAAH9/fwAKAAAAIgAAABgAAAAAAAAAAAAAAAAAAAAAAAAAAAAAAAAAAAAkAAAAJAAAAAAAAAAHAAAAAAAAAAAAAAAAAAAAAAAAAAAAAAAAAAAAf39/ACUAAABYAAAAAAAAAAAAAAAAAAAAAAAAAAAAAAAAAAAAAAAAAAAAAAAAAAAAAAAAAAAAAAA/AAAAAAAAAKCGAQAAAAAAAAAAAAAAAAAMAAAAAQAAAAAAAAAAAAAAAAAAAB8AAABUAAAAAAAABQAAAAEAAAAAAAAAAAAAAAAAAAAAAAAAAAAAAAAAAAAAAAAAAAAAAAJ/f38AAAAAA8zMzADAwP8Af39/AAAAAAAAAAAAAAAAAAAAAAAAAAAAIQAAABgAAAAUAAAAFAMAALwGAAB/NwAAARcAABAAAAAmAAAACAAAAD2wAAAAAAAA"/>
+                <pr:smNativeData xmlns:pr="smNativeData" xmlns="smNativeData" val="SMDATA_15_LkR5ZhMAAAAlAAAAZAAAAA0AAAAAkAAAAJAAAACQAAAAkAAAAAAAAAAAAAAAAAAAAAEAAABQAAAAAAAAAAAA4D8AAAAAAADgPwAAAAAAAOA/AAAAAAAA4D8AAAAAAADgPwAAAAAAAOA/AAAAAAAA4D8AAAAAAADgPwAAAAAAAOA/AAAAAAAA4D8CAAAAjAAAAAAAAAAAAAAAQoX0DP///wgAAAAAAAAAAAAAAAAAAAAAAAAAAAAAAAAAAAAAZAAAAAEAAABAAAAAAAAAAAAAAAAAAAAAAAAAAAAAAAAAAAAAAAAAAAAAAAAAAAAAAAAAAAAAAAAAAAAAAAAAAAAAAAAAAAAAAAAAAAAAAAAAAAAAAAAAAAAAAAAAAAAAFAAAADwAAAAAAAAAAAAAAAAAAAkUAAAAAQAAABQAAAAUAAAAFAAAAAEAAAAAAAAAZAAAAGQAAAAAAAAAZAAAAGQAAAAVAAAAYAAAAAAAAAAAAAAADwAAACADAAAAAAAAAAAAAAEAAACgMgAAVgcAAKr4//8BAAAAf39/AAEAAABkAAAAAAAAABQAAABAHwAAAAAAACYAAAAAAAAAwOD//wAAAAAmAAAAZAAAABYAAABMAAAAAAAAAAAAAAAEAAAAAAAAAAEAAABZWVkKAAAAACgAAAAoAAAAZAAAAGQAAAAAAAAAzMzMAAAAAABQAAAAUAAAAGQAAABkAAAAAAAAABcAAAAUAAAAAAAAAAAAAAD/fwAA/38AAAAAAAAJAAAABAAAAF0AXgAeAAAAaAAAAAAAAAAAAAAAAAAAAAAAAAAAAAAAECcAABAnAAAAAAAAAAAAAAAAAAAAAAAAAAAAAAAAAAAAAAAAAAAAABQAAAAAAAAAwMD/AAAAAABkAAAAMgAAAAAAAABkAAAAAAAAAH9/fwAKAAAAIgAAABgAAAAAAAAAAAAAAAAAAAAAAAAAAAAAAAAAAAAkAAAAJAAAAAAAAAAHAAAAAAAAAAAAAAAAAAAAAAAAAAAAAAAAAAAAf39/ACUAAABYAAAAAAAAAAAAAAAAAAAAAAAAAAAAAAAAAAAAAAAAAAAAAAAAAAAAAAAAAAAAAAA/AAAAAAAAAKCGAQAAAAAAAAAAAAAAAAAMAAAAAQAAAAAAAAAAAAAAAAAAAB8AAABUAAAAAAAABQAAAAEAAAAAAAAAAAAAAAAAAAAAAAAAAAAAAAAAAAAAAAAAAAAAAAJ/f38AAAAAA8zMzADAwP8Af39/AAAAAAAAAAAAAAAAAAAAAAAAAAAAIQAAABgAAAAUAAAAFAMAALwGAAB/NwAAARcAABAAAAAmAAAACAAAAD2wAAAAAAAA"/>
               </a:ext>
             </a:extLst>
           </p:cNvSpPr>
@@ -5199,7 +5078,7 @@
             <a:spLocks noGrp="1" noChangeArrowheads="1"/>
             <a:extLst>
               <a:ext uri="smNativeData">
-                <pr:smNativeData xmlns:pr="smNativeData" xmlns="smNativeData" val="SMDATA_15_EkJ5ZhMAAAAlAAAAZAAAAA0AAAAAkAAAAJAAAACQAAAAkAAAAAAAAAAAAAAAAAAAAAEAAABQAAAAAAAAAAAA4D8AAAAAAADgPwAAAAAAAOA/AAAAAAAA4D8AAAAAAADgPwAAAAAAAOA/AAAAAAAA4D8AAAAAAADgPwAAAAAAAOA/AAAAAAAA4D8CAAAAjAAAAAAAAAAAAAAAQoX0DP///wgAAAAAAAAAAAAAAAAAAAAAAAAAAAAAAAAAAAAAZAAAAAEAAABAAAAAAAAAAAAAAAAAAAAAAAAAAAAAAAAAAAAAAAAAAAAAAAAAAAAAAAAAAAAAAAAAAAAAAAAAAAAAAAAAAAAAAAAAAAAAAAAAAAAAAAAAAAAAAAAAAAAAFAAAADwAAAAAAAAAAAAAAAAAAAkUAAAAAQAAABQAAAAUAAAAFAAAAAEAAAAAAAAAZAAAAGQAAAAAAAAAZAAAAGQAAAAVAAAAYAAAAAAAAAAAAAAADwAAACADAAAAAAAAAAAAAAEAAACgMgAAVgcAAKr4//8BAAAAf39/AAEAAABkAAAAAAAAABQAAABAHwAAAAAAACYAAAAAAAAAwOD//wAAAAAmAAAAZAAAABYAAABMAAAAAAAAAAAAAAAEAAAAAAAAAAEAAABZWVkKAAAAACgAAAAoAAAAZAAAAGQAAAAAAAAAzMzMAAAAAABQAAAAUAAAAGQAAABkAAAAAAAAABcAAAAUAAAAAAAAAAAAAAD/fwAA/38AAAAAAAAJAAAABAAAAAAAAAAeAAAAaAAAAAAAAAAAAAAAAAAAAAAAAAAAAAAAECcAABAnAAAAAAAAAAAAAAAAAAAAAAAAAAAAAAAAAAAAAAAAAAAAABQAAAAAAAAAwMD/AAAAAABkAAAAMgAAAAAAAABkAAAAAAAAAH9/fwAKAAAAIgAAABgAAAAAAAAAAAAAAAAAAAAAAAAAAAAAAAAAAAAkAAAAJAAAAAAAAAAHAAAAAAAAAAAAAAAAAAAAAAAAAAAAAAAAAAAAf39/ACUAAABYAAAAAAAAAAAAAAAAAAAAAAAAAAAAAAAAAAAAAAAAAAAAAAAAAAAAAAAAAAAAAAA/AAAAAAAAAKCGAQAAAAAAAAAAAAAAAAAMAAAAAQAAAAAAAAAAAAAAAAAAAB8AAABUAAAAAAAABQAAAAEAAAAAAAAAAAAAAAAAAAAAAAAAAAAAAAAAAAAAAAAAAAAAAAJ/f38AAAAAA8zMzADAwP8Af39/AAAAAAAAAAAAAAAAAAAAAAAAAAAAIQAAABgAAAAUAAAAFAMAAMADAAALMwAAQQoAABAAAAAmAAAACAAAAD2wAAAAAAAA"/>
+                <pr:smNativeData xmlns:pr="smNativeData" xmlns="smNativeData" val="SMDATA_15_LkR5ZhMAAAAlAAAAZAAAAA0AAAAAkAAAAJAAAACQAAAAkAAAAAAAAAAAAAAAAAAAAAEAAABQAAAAAAAAAAAA4D8AAAAAAADgPwAAAAAAAOA/AAAAAAAA4D8AAAAAAADgPwAAAAAAAOA/AAAAAAAA4D8AAAAAAADgPwAAAAAAAOA/AAAAAAAA4D8CAAAAjAAAAAAAAAAAAAAAQoX0DP///wgAAAAAAAAAAAAAAAAAAAAAAAAAAAAAAAAAAAAAZAAAAAEAAABAAAAAAAAAAAAAAAAAAAAAAAAAAAAAAAAAAAAAAAAAAAAAAAAAAAAAAAAAAAAAAAAAAAAAAAAAAAAAAAAAAAAAAAAAAAAAAAAAAAAAAAAAAAAAAAAAAAAAFAAAADwAAAAAAAAAAAAAAAAAAAkUAAAAAQAAABQAAAAUAAAAFAAAAAEAAAAAAAAAZAAAAGQAAAAAAAAAZAAAAGQAAAAVAAAAYAAAAAAAAAAAAAAADwAAACADAAAAAAAAAAAAAAEAAACgMgAAVgcAAKr4//8BAAAAf39/AAEAAABkAAAAAAAAABQAAABAHwAAAAAAACYAAAAAAAAAwOD//wAAAAAmAAAAZAAAABYAAABMAAAAAAAAAAAAAAAEAAAAAAAAAAEAAABZWVkKAAAAACgAAAAoAAAAZAAAAGQAAAAAAAAAzMzMAAAAAABQAAAAUAAAAGQAAABkAAAAAAAAABcAAAAUAAAAAAAAAAAAAAD/fwAA/38AAAAAAAAJAAAABAAAAAAAAAAeAAAAaAAAAAAAAAAAAAAAAAAAAAAAAAAAAAAAECcAABAnAAAAAAAAAAAAAAAAAAAAAAAAAAAAAAAAAAAAAAAAAAAAABQAAAAAAAAAwMD/AAAAAABkAAAAMgAAAAAAAABkAAAAAAAAAH9/fwAKAAAAIgAAABgAAAAAAAAAAAAAAAAAAAAAAAAAAAAAAAAAAAAkAAAAJAAAAAAAAAAHAAAAAAAAAAAAAAAAAAAAAAAAAAAAAAAAAAAAf39/ACUAAABYAAAAAAAAAAAAAAAAAAAAAAAAAAAAAAAAAAAAAAAAAAAAAAAAAAAAAAAAAAAAAAA/AAAAAAAAAKCGAQAAAAAAAAAAAAAAAAAMAAAAAQAAAAAAAAAAAAAAAAAAAB8AAABUAAAAAAAABQAAAAEAAAAAAAAAAAAAAAAAAAAAAAAAAAAAAAAAAAAAAAAAAAAAAAJ/f38AAAAAA8zMzADAwP8Af39/AAAAAAAAAAAAAAAAAAAAAAAAAAAAIQAAABgAAAAUAAAAFAMAAMADAAALMwAAQQoAABAAAAAmAAAACAAAAD2wAAAAAAAA"/>
               </a:ext>
             </a:extLst>
           </p:cNvSpPr>
@@ -5386,7 +5265,7 @@
             <a:spLocks noGrp="1" noChangeArrowheads="1"/>
             <a:extLst>
               <a:ext uri="smNativeData">
-                <pr:smNativeData xmlns:pr="smNativeData" xmlns="smNativeData" val="SMDATA_15_EkJ5ZhMAAAAlAAAAZAAAAA0AAAAAkAAAAJAAAACQAAAAkAAAAAAAAAAAAAAAAAAAAAEAAABQAAAAAAAAAAAA4D8AAAAAAADgPwAAAAAAAOA/AAAAAAAA4D8AAAAAAADgPwAAAAAAAOA/AAAAAAAA4D8AAAAAAADgPwAAAAAAAOA/AAAAAAAA4D8CAAAAjAAAAAAAAAAAAAAAQoX0DP///wgAAAAAAAAAAAAAAAAAAAAAAAAAAAAAAAAAAAAAZAAAAAEAAABAAAAAAAAAAAAAAAAAAAAAAAAAAAAAAAAAAAAAAAAAAAAAAAAAAAAAAAAAAAAAAAAAAAAAAAAAAAAAAAAAAAAAAAAAAAAAAAAAAAAAAAAAAAAAAAAAAAAAFAAAADwAAAAAAAAAAAAAAAAAAAkUAAAAAQAAABQAAAAUAAAAFAAAAAEAAAAAAAAAZAAAAGQAAAAAAAAAZAAAAGQAAAAVAAAAYAAAAAAAAAAAAAAADwAAACADAAAAAAAAAAAAAAEAAACgMgAAVgcAAKr4//8BAAAAf39/AAEAAABkAAAAAAAAABQAAABAHwAAAAAAACYAAAAAAAAAwOD//wAAAAAmAAAAZAAAABYAAABMAAAAAAAAAAAAAAAEAAAAAAAAAAEAAABZWVkKAAAAACgAAAAoAAAAZAAAAGQAAAAAAAAAzMzMAAAAAABQAAAAUAAAAGQAAABkAAAAAAAAABcAAAAUAAAAAAAAAAAAAAD/fwAA/38AAAAAAAAJAAAABAAAAAAAAAAeAAAAaAAAAAAAAAAAAAAAAAAAAAAAAAAAAAAAECcAABAnAAAAAAAAAAAAAAAAAAAAAAAAAAAAAAAAAAAAAAAAAAAAABQAAAAAAAAAwMD/AAAAAABkAAAAMgAAAAAAAABkAAAAAAAAAH9/fwAKAAAAIgAAABgAAAAAAAAAAAAAAAAAAAAAAAAAAAAAAAAAAAAkAAAAJAAAAAAAAAAHAAAAAAAAAAAAAAAAAAAAAAAAAAAAAAAAAAAAf39/ACUAAABYAAAAAAAAAAAAAAAAAAAAAAAAAAAAAAAAAAAAAAAAAAAAAAAAAAAAAAAAAAAAAAA/AAAAAAAAAKCGAQAAAAAAAAAAAAAAAAAMAAAAAQAAAAAAAAAAAAAAAAAAAB8AAABUAAAAAAAABQAAAAEAAAAAAAAAAAAAAAAAAAAAAAAAAAAAAAAAAAAAAAAAAAAAAAJ/f38AAAAAA8zMzADAwP8Af39/AAAAAAAAAAAAAAAAAAAAAAAAAAAAIQAAABgAAAAUAAAAShMAAK8ZAABQNwAAgB4AABAAAAAmAAAACAAAAD2wAAAAAAAA"/>
+                <pr:smNativeData xmlns:pr="smNativeData" xmlns="smNativeData" val="SMDATA_15_LkR5ZhMAAAAlAAAAZAAAAA0AAAAAkAAAAJAAAACQAAAAkAAAAAAAAAAAAAAAAAAAAAEAAABQAAAAAAAAAAAA4D8AAAAAAADgPwAAAAAAAOA/AAAAAAAA4D8AAAAAAADgPwAAAAAAAOA/AAAAAAAA4D8AAAAAAADgPwAAAAAAAOA/AAAAAAAA4D8CAAAAjAAAAAAAAAAAAAAAQoX0DP///wgAAAAAAAAAAAAAAAAAAAAAAAAAAAAAAAAAAAAAZAAAAAEAAABAAAAAAAAAAAAAAAAAAAAAAAAAAAAAAAAAAAAAAAAAAAAAAAAAAAAAAAAAAAAAAAAAAAAAAAAAAAAAAAAAAAAAAAAAAAAAAAAAAAAAAAAAAAAAAAAAAAAAFAAAADwAAAAAAAAAAAAAAAAAAAkUAAAAAQAAABQAAAAUAAAAFAAAAAEAAAAAAAAAZAAAAGQAAAAAAAAAZAAAAGQAAAAVAAAAYAAAAAAAAAAAAAAADwAAACADAAAAAAAAAAAAAAEAAACgMgAAVgcAAKr4//8BAAAAf39/AAEAAABkAAAAAAAAABQAAABAHwAAAAAAACYAAAAAAAAAwOD//wAAAAAmAAAAZAAAABYAAABMAAAAAAAAAAAAAAAEAAAAAAAAAAEAAABZWVkKAAAAACgAAAAoAAAAZAAAAGQAAAAAAAAAzMzMAAAAAABQAAAAUAAAAGQAAABkAAAAAAAAABcAAAAUAAAAAAAAAAAAAAD/fwAA/38AAAAAAAAJAAAABAAAAAAAAAAeAAAAaAAAAAAAAAAAAAAAAAAAAAAAAAAAAAAAECcAABAnAAAAAAAAAAAAAAAAAAAAAAAAAAAAAAAAAAAAAAAAAAAAABQAAAAAAAAAwMD/AAAAAABkAAAAMgAAAAAAAABkAAAAAAAAAH9/fwAKAAAAIgAAABgAAAAAAAAAAAAAAAAAAAAAAAAAAAAAAAAAAAAkAAAAJAAAAAAAAAAHAAAAAAAAAAAAAAAAAAAAAAAAAAAAAAAAAAAAf39/ACUAAABYAAAAAAAAAAAAAAAAAAAAAAAAAAAAAAAAAAAAAAAAAAAAAAAAAAAAAAAAAAAAAAA/AAAAAAAAAKCGAQAAAAAAAAAAAAAAAAAMAAAAAQAAAAAAAAAAAAAAAAAAAB8AAABUAAAAAAAABQAAAAEAAAAAAAAAAAAAAAAAAAAAAAAAAAAAAAAAAAAAAAAAAAAAAAJ/f38AAAAAA8zMzADAwP8Af39/AAAAAAAAAAAAAAAAAAAAAAAAAAAAIQAAABgAAAAUAAAAShMAAK8ZAABQNwAAgB4AABAAAAAmAAAACAAAAD2wAAAAAAAA"/>
               </a:ext>
             </a:extLst>
           </p:cNvSpPr>
@@ -5573,7 +5452,7 @@
             <a:spLocks noGrp="1" noChangeArrowheads="1"/>
             <a:extLst>
               <a:ext uri="smNativeData">
-                <pr:smNativeData xmlns:pr="smNativeData" xmlns="smNativeData" val="SMDATA_15_EkJ5ZhMAAAAlAAAAZAAAAA0AAAAAkAAAAJAAAACQAAAAkAAAAAAAAAAAAAAAAAAAAAEAAABQAAAAAAAAAAAA4D8AAAAAAADgPwAAAAAAAOA/AAAAAAAA4D8AAAAAAADgPwAAAAAAAOA/AAAAAAAA4D8AAAAAAADgPwAAAAAAAOA/AAAAAAAA4D8CAAAAjAAAAAAAAAAAAAAAQoX0DP///wgAAAAAAAAAAAAAAAAAAAAAAAAAAAAAAAAAAAAAZAAAAAEAAABAAAAAAAAAAAAAAAAAAAAAAAAAAAAAAAAAAAAAAAAAAAAAAAAAAAAAAAAAAAAAAAAAAAAAAAAAAAAAAAAAAAAAAAAAAAAAAAAAAAAAAAAAAAAAAAAAAAAAFAAAADwAAAAAAAAAAAAAAAAAAAkUAAAAAQAAABQAAAAUAAAAFAAAAAEAAAAAAAAAZAAAAGQAAAAAAAAAZAAAAGQAAAAVAAAAYAAAAAAAAAAAAAAADwAAACADAAAAAAAAAAAAAAEAAACgMgAAVgcAAKr4//8BAAAAf39/AAEAAABkAAAAAAAAABQAAABAHwAAAAAAACYAAAAAAAAAwOD//wAAAAAmAAAAZAAAABYAAABMAAAAAAAAAAAAAAAEAAAAAAAAAAEAAABZWVkKAAAAACgAAAAoAAAAZAAAAGQAAAAAAAAAzMzMAAAAAABQAAAAUAAAAGQAAABkAAAAAAAAABcAAAAUAAAAAAAAAAAAAAD/fwAA/38AAAAAAAAJAAAABAAAAADvvg8eAAAAaAAAAAAAAAAAAAAAAAAAAAAAAAAAAAAAECcAABAnAAAAAAAAAAAAAAAAAAAAAAAAAAAAAAAAAAAAAAAAAAAAABQAAAAAAAAAwMD/AAAAAABkAAAAMgAAAAAAAABkAAAAAAAAAH9/fwAKAAAAIgAAABgAAAAAAAAAAAAAAAAAAAAAAAAAAAAAAAAAAAAkAAAAJAAAAAAAAAAHAAAAAAAAAAAAAAAAAAAAAAAAAAAAAAAAAAAAf39/ACUAAABYAAAAAAAAAAAAAAAAAAAAAAAAAAAAAAAAAAAAAAAAAAAAAAAAAAAAAAAAAAAAAAA/AAAAAAAAAKCGAQAAAAAAAAAAAAAAAAAMAAAAAQAAAAAAAAAAAAAAAAAAAB8AAABUAAAAAAAABQAAAAEAAAAAAAAAAAAAAAAAAAAAAAAAAAAAAAAAAAAAAAAAAAAAAAJ/f38AAAAAA8zMzADAwP8Af39/AAAAAAAAAAAAAAAAAAAAAAAAAAAAIQAAABgAAAAUAAAAShMAACUcAABQNwAApSIAABAAAAAmAAAACAAAAD2wAAAAAAAA"/>
+                <pr:smNativeData xmlns:pr="smNativeData" xmlns="smNativeData" val="SMDATA_15_LkR5ZhMAAAAlAAAAZAAAAA0AAAAAkAAAAJAAAACQAAAAkAAAAAAAAAAAAAAAAAAAAAEAAABQAAAAAAAAAAAA4D8AAAAAAADgPwAAAAAAAOA/AAAAAAAA4D8AAAAAAADgPwAAAAAAAOA/AAAAAAAA4D8AAAAAAADgPwAAAAAAAOA/AAAAAAAA4D8CAAAAjAAAAAAAAAAAAAAAQoX0DP///wgAAAAAAAAAAAAAAAAAAAAAAAAAAAAAAAAAAAAAZAAAAAEAAABAAAAAAAAAAAAAAAAAAAAAAAAAAAAAAAAAAAAAAAAAAAAAAAAAAAAAAAAAAAAAAAAAAAAAAAAAAAAAAAAAAAAAAAAAAAAAAAAAAAAAAAAAAAAAAAAAAAAAFAAAADwAAAAAAAAAAAAAAAAAAAkUAAAAAQAAABQAAAAUAAAAFAAAAAEAAAAAAAAAZAAAAGQAAAAAAAAAZAAAAGQAAAAVAAAAYAAAAAAAAAAAAAAADwAAACADAAAAAAAAAAAAAAEAAACgMgAAVgcAAKr4//8BAAAAf39/AAEAAABkAAAAAAAAABQAAABAHwAAAAAAACYAAAAAAAAAwOD//wAAAAAmAAAAZAAAABYAAABMAAAAAAAAAAAAAAAEAAAAAAAAAAEAAABZWVkKAAAAACgAAAAoAAAAZAAAAGQAAAAAAAAAzMzMAAAAAABQAAAAUAAAAGQAAABkAAAAAAAAABcAAAAUAAAAAAAAAAAAAAD/fwAA/38AAAAAAAAJAAAABAAAAADvvg8eAAAAaAAAAAAAAAAAAAAAAAAAAAAAAAAAAAAAECcAABAnAAAAAAAAAAAAAAAAAAAAAAAAAAAAAAAAAAAAAAAAAAAAABQAAAAAAAAAwMD/AAAAAABkAAAAMgAAAAAAAABkAAAAAAAAAH9/fwAKAAAAIgAAABgAAAAAAAAAAAAAAAAAAAAAAAAAAAAAAAAAAAAkAAAAJAAAAAAAAAAHAAAAAAAAAAAAAAAAAAAAAAAAAAAAAAAAAAAAf39/ACUAAABYAAAAAAAAAAAAAAAAAAAAAAAAAAAAAAAAAAAAAAAAAAAAAAAAAAAAAAAAAAAAAAA/AAAAAAAAAKCGAQAAAAAAAAAAAAAAAAAMAAAAAQAAAAAAAAAAAAAAAAAAAB8AAABUAAAAAAAABQAAAAEAAAAAAAAAAAAAAAAAAAAAAAAAAAAAAAAAAAAAAAAAAAAAAAJ/f38AAAAAA8zMzADAwP8Af39/AAAAAAAAAAAAAAAAAAAAAAAAAAAAIQAAABgAAAAUAAAAShMAACUcAABQNwAApSIAABAAAAAmAAAACAAAAD2wAAAAAAAA"/>
               </a:ext>
             </a:extLst>
           </p:cNvSpPr>
@@ -5760,7 +5639,7 @@
             <a:spLocks noGrp="1" noChangeArrowheads="1"/>
             <a:extLst>
               <a:ext uri="smNativeData">
-                <pr:smNativeData xmlns:pr="smNativeData" xmlns="smNativeData" val="SMDATA_15_EkJ5ZhMAAAAlAAAAZAAAAA0AAAAAkAAAAJAAAACQAAAAkAAAAAAAAAAAAAAAAAAAAAEAAABQAAAAAAAAAAAA4D8AAAAAAADgPwAAAAAAAOA/AAAAAAAA4D8AAAAAAADgPwAAAAAAAOA/AAAAAAAA4D8AAAAAAADgPwAAAAAAAOA/AAAAAAAA4D8CAAAAjAAAAAAAAAAAAAAAQoX0DP///wgAAAAAAAAAAAAAAAAAAAAAAAAAAAAAAAAAAAAAZAAAAAEAAABAAAAAAAAAAAAAAAAAAAAAAAAAAAAAAAAAAAAAAAAAAAAAAAAAAAAAAAAAAAAAAAAAAAAAAAAAAAAAAAAAAAAAAAAAAAAAAAAAAAAAAAAAAAAAAAAAAAAAFAAAADwAAAAAAAAAAAAAAAAAAAkUAAAAAQAAABQAAAAUAAAAFAAAAAEAAAAAAAAAZAAAAGQAAAAAAAAAZAAAAGQAAAAVAAAAYAAAAAAAAAAAAAAADwAAACADAAAAAAAAAAAAAAEAAACgMgAAVgcAAKr4//8BAAAAf39/AAEAAABkAAAAAAAAABQAAABAHwAAAAAAACYAAAAAAAAAwOD//wAAAAAmAAAAZAAAABYAAABMAAAAAAAAAAAAAAAEAAAAAAAAAAEAAABZWVkKAAAAACgAAAAoAAAAZAAAAGQAAAAAAAAAzMzMAAAAAABQAAAAUAAAAGQAAABkAAAAAAAAABcAAAAUAAAAAAAAAAAAAAD/fwAA/38AAAAAAAAJAAAABAAAAIAmcwceAAAAaAAAAAAAAAAAAAAAAAAAAAAAAAAAAAAAECcAABAnAAAAAAAAAAAAAAAAAAAAAAAAAAAAAAAAAAAAAAAAAAAAABQAAAAAAAAAwMD/AAAAAABkAAAAMgAAAAAAAABkAAAAAAAAAH9/fwAKAAAAIgAAABgAAAAAAAAAAAAAAAAAAAAAAAAAAAAAAAAAAAAkAAAAJAAAAAAAAAAHAAAAAAAAAAAAAAAAAAAAAAAAAAAAAAAAAAAAf39/ACUAAABYAAAAAAAAAAAAAAAAAAAAAAAAAAAAAAAAAAAAAAAAAAAAAAAAAAAAAAAAAAAAAAA/AAAAAAAAAKCGAQAAAAAAAAAAAAAAAAAMAAAAAQAAAAAAAAAAAAAAAAAAAB8AAABUAAAAAAAABQAAAAEAAAAAAAAAAAAAAAAAAAAAAAAAAAAAAAAAAAAAAAAAAAAAAAJ/f38AAAAAA8zMzADAwP8Af39/AAAAAAAAAAAAAAAAAAAAAAAAAAAAIQAAABgAAAAUAAAAShMAAEofAABQNwAAwycAABAAAAAmAAAACAAAAD2wAAAAAAAA"/>
+                <pr:smNativeData xmlns:pr="smNativeData" xmlns="smNativeData" val="SMDATA_15_LkR5ZhMAAAAlAAAAZAAAAA0AAAAAkAAAAJAAAACQAAAAkAAAAAAAAAAAAAAAAAAAAAEAAABQAAAAAAAAAAAA4D8AAAAAAADgPwAAAAAAAOA/AAAAAAAA4D8AAAAAAADgPwAAAAAAAOA/AAAAAAAA4D8AAAAAAADgPwAAAAAAAOA/AAAAAAAA4D8CAAAAjAAAAAAAAAAAAAAAQoX0DP///wgAAAAAAAAAAAAAAAAAAAAAAAAAAAAAAAAAAAAAZAAAAAEAAABAAAAAAAAAAAAAAAAAAAAAAAAAAAAAAAAAAAAAAAAAAAAAAAAAAAAAAAAAAAAAAAAAAAAAAAAAAAAAAAAAAAAAAAAAAAAAAAAAAAAAAAAAAAAAAAAAAAAAFAAAADwAAAAAAAAAAAAAAAAAAAkUAAAAAQAAABQAAAAUAAAAFAAAAAEAAAAAAAAAZAAAAGQAAAAAAAAAZAAAAGQAAAAVAAAAYAAAAAAAAAAAAAAADwAAACADAAAAAAAAAAAAAAEAAACgMgAAVgcAAKr4//8BAAAAf39/AAEAAABkAAAAAAAAABQAAABAHwAAAAAAACYAAAAAAAAAwOD//wAAAAAmAAAAZAAAABYAAABMAAAAAAAAAAAAAAAEAAAAAAAAAAEAAABZWVkKAAAAACgAAAAoAAAAZAAAAGQAAAAAAAAAzMzMAAAAAABQAAAAUAAAAGQAAABkAAAAAAAAABcAAAAUAAAAAAAAAAAAAAD/fwAA/38AAAAAAAAJAAAABAAAAIAmcwceAAAAaAAAAAAAAAAAAAAAAAAAAAAAAAAAAAAAECcAABAnAAAAAAAAAAAAAAAAAAAAAAAAAAAAAAAAAAAAAAAAAAAAABQAAAAAAAAAwMD/AAAAAABkAAAAMgAAAAAAAABkAAAAAAAAAH9/fwAKAAAAIgAAABgAAAAAAAAAAAAAAAAAAAAAAAAAAAAAAAAAAAAkAAAAJAAAAAAAAAAHAAAAAAAAAAAAAAAAAAAAAAAAAAAAAAAAAAAAf39/ACUAAABYAAAAAAAAAAAAAAAAAAAAAAAAAAAAAAAAAAAAAAAAAAAAAAAAAAAAAAAAAAAAAAA/AAAAAAAAAKCGAQAAAAAAAAAAAAAAAAAMAAAAAQAAAAAAAAAAAAAAAAAAAB8AAABUAAAAAAAABQAAAAEAAAAAAAAAAAAAAAAAAAAAAAAAAAAAAAAAAAAAAAAAAAAAAAJ/f38AAAAAA8zMzADAwP8Af39/AAAAAAAAAAAAAAAAAAAAAAAAAAAAIQAAABgAAAAUAAAAShMAAEofAABQNwAAwycAABAAAAAmAAAACAAAAD2wAAAAAAAA"/>
               </a:ext>
             </a:extLst>
           </p:cNvSpPr>
@@ -5973,7 +5852,7 @@
             <a:spLocks noGrp="1" noChangeArrowheads="1"/>
             <a:extLst>
               <a:ext uri="smNativeData">
-                <pr:smNativeData xmlns:pr="smNativeData" xmlns="smNativeData" val="SMDATA_15_EkJ5ZhMAAAAlAAAAZAAAAA0AAAAAkAAAAJAAAACQAAAAkAAAAAAAAAABAAAAAAAAAAEAAABQAAAAAAAAAAAA4D8AAAAAAADgPwAAAAAAAOA/AAAAAAAA4D8AAAAAAADgPwAAAAAAAOA/AAAAAAAA4D8AAAAAAADgPwAAAAAAAOA/AAAAAAAA4D8CAAAAjAAAAAAAAAAAAAAAQoX0DP///wgAAAAAAAAAAAAAAAAAAAAAAAAAAAAAAAAAAAAAZAAAAAEAAABAAAAAAAAAAAAAAAAAAAAAAAAAAAAAAAAAAAAAAAAAAAAAAAAAAAAAAAAAAAAAAAAAAAAAAAAAAAAAAAAAAAAAAAAAAAAAAAAAAAAAAAAAAAAAAAAAAAAAFAAAADwAAAAAAAAAAAAAAAAAAAkUAAAAAQAAABQAAAAUAAAAFAAAAAEAAAAAAAAAZAAAAGQAAAAAAAAAZAAAAGQAAAAVAAAAYAAAAAAAAAAAAAAADwAAACADAAAAAAAAAAAAAAEAAACgMgAAVgcAAKr4//8BAAAAf39/AAEAAABkAAAAAAAAABQAAABAHwAAAAAAACYAAAAAAAAAwOD//wAAAAAmAAAAZAAAABYAAABMAAAAAAAAAAAAAAAEAAAAAAAAAAEAAABZWVkKAAAAACgAAAAoAAAAZAAAAGQAAAAAAAAAzMzMAAAAAABQAAAAUAAAAGQAAABkAAAAAAAAABcAAAAUAAAAAAAAAAAAAAD/fwAA/38AAAAAAAAJAAAABAAAAF8AYAAeAAAAaAAAAAAAAAAAAAAAAAAAAAAAAAAAAAAAECcAABAnAAAAAAAAAAAAAAAAAAAAAAAAAAAAAAAAAAAAAAAAAAAAABQAAAAAAAAAwMD/AAAAAABkAAAAMgAAAAAAAABkAAAAAAAAAH9/fwAKAAAAIgAAABgAAAAAAAAAAAAAAAAAAAAAAAAAAAAAAAAAAAAkAAAAJAAAAAAAAAAHAAAAAAAAAAAAAAAAAAAAAAAAAAAAAAAAAAAAf39/ACUAAABYAAAAAAAAAAAAAAAAAAAAAAAAAAAAAAAAAAAAAAAAAAAAAAAAAAAAAAAAAAAAAAA/AAAAAAAAAKCGAQAAAAAAAAAAAAAAAAAMAAAAAQAAAAAAAAAAAAAAAAAAAB8AAABUAAAAAAAABQAAAAEAAAAAAAAAAAAAAAAAAAAAAAAAAAAAAAAAAAAAAAAAAAAAAAJ/f38AAAAAA8zMzADAwP8Af39/AAAAAAAAAAAAAAAAAAAAAAAAAAAAIQAAABgAAAAUAAAAHjQAAEAmAAB/NwAAeikAABAAAAAmAAAACAAAADywAAAAAAAA"/>
+                <pr:smNativeData xmlns:pr="smNativeData" xmlns="smNativeData" val="SMDATA_15_LkR5ZhMAAAAlAAAAZAAAAA0AAAAAkAAAAJAAAACQAAAAkAAAAAAAAAABAAAAAAAAAAEAAABQAAAAAAAAAAAA4D8AAAAAAADgPwAAAAAAAOA/AAAAAAAA4D8AAAAAAADgPwAAAAAAAOA/AAAAAAAA4D8AAAAAAADgPwAAAAAAAOA/AAAAAAAA4D8CAAAAjAAAAAAAAAAAAAAAQoX0DP///wgAAAAAAAAAAAAAAAAAAAAAAAAAAAAAAAAAAAAAZAAAAAEAAABAAAAAAAAAAAAAAAAAAAAAAAAAAAAAAAAAAAAAAAAAAAAAAAAAAAAAAAAAAAAAAAAAAAAAAAAAAAAAAAAAAAAAAAAAAAAAAAAAAAAAAAAAAAAAAAAAAAAAFAAAADwAAAAAAAAAAAAAAAAAAAkUAAAAAQAAABQAAAAUAAAAFAAAAAEAAAAAAAAAZAAAAGQAAAAAAAAAZAAAAGQAAAAVAAAAYAAAAAAAAAAAAAAADwAAACADAAAAAAAAAAAAAAEAAACgMgAAVgcAAKr4//8BAAAAf39/AAEAAABkAAAAAAAAABQAAABAHwAAAAAAACYAAAAAAAAAwOD//wAAAAAmAAAAZAAAABYAAABMAAAAAAAAAAAAAAAEAAAAAAAAAAEAAABZWVkKAAAAACgAAAAoAAAAZAAAAGQAAAAAAAAAzMzMAAAAAABQAAAAUAAAAGQAAABkAAAAAAAAABcAAAAUAAAAAAAAAAAAAAD/fwAA/38AAAAAAAAJAAAABAAAAF8AYAAeAAAAaAAAAAAAAAAAAAAAAAAAAAAAAAAAAAAAECcAABAnAAAAAAAAAAAAAAAAAAAAAAAAAAAAAAAAAAAAAAAAAAAAABQAAAAAAAAAwMD/AAAAAABkAAAAMgAAAAAAAABkAAAAAAAAAH9/fwAKAAAAIgAAABgAAAAAAAAAAAAAAAAAAAAAAAAAAAAAAAAAAAAkAAAAJAAAAAAAAAAHAAAAAAAAAAAAAAAAAAAAAAAAAAAAAAAAAAAAf39/ACUAAABYAAAAAAAAAAAAAAAAAAAAAAAAAAAAAAAAAAAAAAAAAAAAAAAAAAAAAAAAAAAAAAA/AAAAAAAAAKCGAQAAAAAAAAAAAAAAAAAMAAAAAQAAAAAAAAAAAAAAAAAAAB8AAABUAAAAAAAABQAAAAEAAAAAAAAAAAAAAAAAAAAAAAAAAAAAAAAAAAAAAAAAAAAAAAJ/f38AAAAAA8zMzADAwP8Af39/AAAAAAAAAAAAAAAAAAAAAAAAAAAAIQAAABgAAAAUAAAAHjQAAEAmAAB/NwAAeikAABAAAAAmAAAACAAAADywAAAAAAAA"/>
               </a:ext>
             </a:extLst>
           </p:cNvSpPr>
@@ -6027,10 +5906,11 @@
               </a:spcAft>
               <a:buNone/>
             </a:pPr>
-            <a:fld id="{3FC23DA8-E6D2-97CB-9C7A-109E73346A45}" type="slidenum">
+            <a:fld id="{3FDACB68-26D2-8F3D-9C62-D068852C6A85}" type="slidenum">
               <a:rPr lang="ru-ru" cap="none"/>
               <a:t/>
             </a:fld>
+            <a:endParaRPr lang="ru-ru" cap="none"/>
           </a:p>
         </p:txBody>
       </p:sp>
@@ -6041,7 +5921,7 @@
             <a:spLocks noGrp="1" noChangeArrowheads="1"/>
             <a:extLst>
               <a:ext uri="smNativeData">
-                <pr:smNativeData xmlns:pr="smNativeData" xmlns="smNativeData" val="SMDATA_15_EkJ5ZhMAAAAlAAAAZAAAAA0AAAAAkAAAAJAAAACQAAAAkAAAAAAAAAAAAAAAAAAAAAEAAABQAAAAAAAAAAAA4D8AAAAAAADgPwAAAAAAAOA/AAAAAAAA4D8AAAAAAADgPwAAAAAAAOA/AAAAAAAA4D8AAAAAAADgPwAAAAAAAOA/AAAAAAAA4D8CAAAAjAAAAAAAAAAAAAAAQoX0DP///wgAAAAAAAAAAAAAAAAAAAAAAAAAAAAAAAAAAAAAZAAAAAEAAABAAAAAAAAAAAAAAAAAAAAAAAAAAAAAAAAAAAAAAAAAAAAAAAAAAAAAAAAAAAAAAAAAAAAAAAAAAAAAAAAAAAAAAAAAAAAAAAAAAAAAAAAAAAAAAAAAAAAAFAAAADwAAAAAAAAAAAAAAAAAAAkUAAAAAQAAABQAAAAUAAAAFAAAAAEAAAAAAAAAZAAAAGQAAAAAAAAAZAAAAGQAAAAVAAAAYAAAAAAAAAAAAAAADwAAACADAAAAAAAAAAAAAAEAAACgMgAAVgcAAKr4//8BAAAAf39/AAEAAABkAAAAAAAAABQAAABAHwAAAAAAACYAAAAAAAAAwOD//wAAAAAmAAAAZAAAABYAAABMAAAAAAAAAAAAAAAEAAAAAAAAAAEAAABZWVkKAAAAACgAAAAoAAAAZAAAAGQAAAAAAAAAzMzMAAAAAABQAAAAUAAAAGQAAABkAAAAAAAAABcAAAAUAAAAAAAAAAAAAAD/fwAA/38AAAAAAAAJAAAABAAAAADvvg8eAAAAaAAAAAAAAAAAAAAAAAAAAAAAAAAAAAAAECcAABAnAAAAAAAAAAAAAAAAAAAAAAAAAAAAAAAAAAAAAAAAAAAAABQAAAAAAAAAwMD/AAAAAABkAAAAMgAAAAAAAABkAAAAAAAAAH9/fwAKAAAAIgAAABgAAAAAAAAAAAAAAAAAAAAAAAAAAAAAAAAAAAAkAAAAJAAAAAAAAAAHAAAAAAAAAAAAAAAAAAAAAAAAAAAAAAAAAAAAf39/ACUAAABYAAAAAAAAAAAAAAAAAAAAAAAAAAAAAAAAAAAAAAAAAAAAAAAAAAAAAAAAAAAAAAA/AAAAAAAAAKCGAQAAAAAAAAAAAAAAAAAMAAAAAQAAAAAAAAAAAAAAAAAAAB8AAABUAAAAAAAABQAAAAEAAAAAAAAAAAAAAAAAAAAAAAAAAAAAAAAAAAAAAAAAAAAAAAJ/f38AAAAAA8zMzADAwP8Af39/AAAAAAAAAAAAAAAAAAAAAAAAAAAAIQAAABgAAAAUAAAAFAMAALYCAAB/NwAAvwoAABAAAAAmAAAACAAAADywAAAAAAAA"/>
+                <pr:smNativeData xmlns:pr="smNativeData" xmlns="smNativeData" val="SMDATA_15_LkR5ZhMAAAAlAAAAZAAAAA0AAAAAkAAAAJAAAACQAAAAkAAAAAAAAAAAAAAAAAAAAAEAAABQAAAAAAAAAAAA4D8AAAAAAADgPwAAAAAAAOA/AAAAAAAA4D8AAAAAAADgPwAAAAAAAOA/AAAAAAAA4D8AAAAAAADgPwAAAAAAAOA/AAAAAAAA4D8CAAAAjAAAAAAAAAAAAAAAQoX0DP///wgAAAAAAAAAAAAAAAAAAAAAAAAAAAAAAAAAAAAAZAAAAAEAAABAAAAAAAAAAAAAAAAAAAAAAAAAAAAAAAAAAAAAAAAAAAAAAAAAAAAAAAAAAAAAAAAAAAAAAAAAAAAAAAAAAAAAAAAAAAAAAAAAAAAAAAAAAAAAAAAAAAAAFAAAADwAAAAAAAAAAAAAAAAAAAkUAAAAAQAAABQAAAAUAAAAFAAAAAEAAAAAAAAAZAAAAGQAAAAAAAAAZAAAAGQAAAAVAAAAYAAAAAAAAAAAAAAADwAAACADAAAAAAAAAAAAAAEAAACgMgAAVgcAAKr4//8BAAAAf39/AAEAAABkAAAAAAAAABQAAABAHwAAAAAAACYAAAAAAAAAwOD//wAAAAAmAAAAZAAAABYAAABMAAAAAAAAAAAAAAAEAAAAAAAAAAEAAABZWVkKAAAAACgAAAAoAAAAZAAAAGQAAAAAAAAAzMzMAAAAAABQAAAAUAAAAGQAAABkAAAAAAAAABcAAAAUAAAAAAAAAAAAAAD/fwAA/38AAAAAAAAJAAAABAAAAADvvg8eAAAAaAAAAAAAAAAAAAAAAAAAAAAAAAAAAAAAECcAABAnAAAAAAAAAAAAAAAAAAAAAAAAAAAAAAAAAAAAAAAAAAAAABQAAAAAAAAAwMD/AAAAAABkAAAAMgAAAAAAAABkAAAAAAAAAH9/fwAKAAAAIgAAABgAAAAAAAAAAAAAAAAAAAAAAAAAAAAAAAAAAAAkAAAAJAAAAAAAAAAHAAAAAAAAAAAAAAAAAAAAAAAAAAAAAAAAAAAAf39/ACUAAABYAAAAAAAAAAAAAAAAAAAAAAAAAAAAAAAAAAAAAAAAAAAAAAAAAAAAAAAAAAAAAAA/AAAAAAAAAKCGAQAAAAAAAAAAAAAAAAAMAAAAAQAAAAAAAAAAAAAAAAAAAB8AAABUAAAAAAAABQAAAAEAAAAAAAAAAAAAAAAAAAAAAAAAAAAAAAAAAAAAAAAAAAAAAAJ/f38AAAAAA8zMzADAwP8Af39/AAAAAAAAAAAAAAAAAAAAAAAAAAAAIQAAABgAAAAUAAAAFAMAALYCAAB/NwAAvwoAABAAAAAmAAAACAAAADywAAAAAAAA"/>
               </a:ext>
             </a:extLst>
           </p:cNvSpPr>
@@ -6151,7 +6031,7 @@
             <a:spLocks noGrp="1" noChangeArrowheads="1"/>
             <a:extLst>
               <a:ext uri="smNativeData">
-                <pr:smNativeData xmlns:pr="smNativeData" xmlns="smNativeData" val="SMDATA_15_EkJ5ZhMAAAAlAAAAZAAAAE0AAAAAkAAAAJAAAACQAAAAkAAAAAAAAAAAAAAAAAAAAAEAAABQAAAAAAAAAAAA4D8AAAAAAADgPwAAAAAAAOA/AAAAAAAA4D8AAAAAAADgPwAAAAAAAOA/AAAAAAAA4D8AAAAAAADgPwAAAAAAAOA/AAAAAAAA4D8CAAAAjAAAAAAAAAAAAAAAQoX0DP///wgAAAAAAAAAAAAAAAAAAAAAAAAAAAAAAAAAAAAAZAAAAAEAAABAAAAAAAAAAAAAAAAAAAAAAAAAAAAAAAAAAAAAAAAAAAAAAAAAAAAAAAAAAAAAAAAAAAAAAAAAAAAAAAAAAAAAAAAAAAAAAAAAAAAAAAAAAAAAAAAAAAAAFAAAADwAAAAAAAAAAAAAAAAAAAkUAAAAAQAAABQAAAAUAAAAFAAAAAEAAAAAAAAAZAAAAGQAAAAAAAAAZAAAAGQAAAAVAAAAYAAAAAAAAAAAAAAADwAAACADAAAAAAAAAAAAAAEAAACgMgAAVgcAAKr4//8BAAAAf39/AAEAAABkAAAAAAAAABQAAABAHwAAAAAAACYAAAAAAAAAwOD//wAAAAAmAAAAZAAAABYAAABMAAAAAAAAAAAAAAAEAAAAAAAAAAEAAABZWVkKAAAAACgAAAAoAAAAZAAAAGQAAAAAAAAAzMzMAAAAAABQAAAAUAAAAGQAAABkAAAAAAAAABcAAAAUAAAAAAAAAAAAAAD/fwAA/38AAAAAAAAJAAAABAAAAGdlODkeAAAAaAAAAAAAAAAAAAAAAAAAAAAAAAAAAAAAECcAABAnAAAAAAAAAAAAAAAAAAAAAAAAAAAAAAAAAAAAAAAAAAAAABQAAAAAAAAAwMD/AAAAAABkAAAAMgAAAAAAAABkAAAAAAAAAH9/fwAKAAAAIgAAABgAAAAAAAAAAAAAAAAAAAAAAAAAAAAAAAAAAAAkAAAAJAAAAAAAAAAHAAAAAAAAAAAAAAAAAAAAAAAAAAAAAAAAAAAAf39/ACUAAABYAAAAAAAAAAAAAAAAAAAAAAAAAAAAAAAAAAAAAAAAAAAAAAAAAAAAAAAAAAAAAAA/AAAAAAAAAKCGAQAAAAAAAAAAAAAAAAAMAAAAAQAAAAAAAAAAAAAAAAAAAB8AAABUAAAAAAAABQAAAAEAAAAAAAAAAAAAAAAAAAAAAAAAAAAAAAAAAAAAAAAAAAAAAAJ/f38AAAAAA8zMzADAwP8Af39/AAAAAAAAAAAAAAAAAAAAAAAAAAAAIQAAABgAAAAUAAAAXAgAALAKAAAUJAAAtiYAABAgAAAmAAAACAAAAD2wAAAAAAAA"/>
+                <pr:smNativeData xmlns:pr="smNativeData" xmlns="smNativeData" val="SMDATA_15_LkR5ZhMAAAAlAAAAZAAAAE0AAAAAkAAAAJAAAACQAAAAkAAAAAAAAAAAAAAAAAAAAAEAAABQAAAAAAAAAAAA4D8AAAAAAADgPwAAAAAAAOA/AAAAAAAA4D8AAAAAAADgPwAAAAAAAOA/AAAAAAAA4D8AAAAAAADgPwAAAAAAAOA/AAAAAAAA4D8CAAAAjAAAAAAAAAAAAAAAQoX0DP///wgAAAAAAAAAAAAAAAAAAAAAAAAAAAAAAAAAAAAAZAAAAAEAAABAAAAAAAAAAAAAAAAAAAAAAAAAAAAAAAAAAAAAAAAAAAAAAAAAAAAAAAAAAAAAAAAAAAAAAAAAAAAAAAAAAAAAAAAAAAAAAAAAAAAAAAAAAAAAAAAAAAAAFAAAADwAAAAAAAAAAAAAAAAAAAkUAAAAAQAAABQAAAAUAAAAFAAAAAEAAAAAAAAAZAAAAGQAAAAAAAAAZAAAAGQAAAAVAAAAYAAAAAAAAAAAAAAADwAAACADAAAAAAAAAAAAAAEAAACgMgAAVgcAAKr4//8BAAAAf39/AAEAAABkAAAAAAAAABQAAABAHwAAAAAAACYAAAAAAAAAwOD//wAAAAAmAAAAZAAAABYAAABMAAAAAAAAAAAAAAAEAAAAAAAAAAEAAABZWVkKAAAAACgAAAAoAAAAZAAAAGQAAAAAAAAAzMzMAAAAAABQAAAAUAAAAGQAAABkAAAAAAAAABcAAAAUAAAAAAAAAAAAAAD/fwAA/38AAAAAAAAJAAAABAAAAGdlODkeAAAAaAAAAAAAAAAAAAAAAAAAAAAAAAAAAAAAECcAABAnAAAAAAAAAAAAAAAAAAAAAAAAAAAAAAAAAAAAAAAAAAAAABQAAAAAAAAAwMD/AAAAAABkAAAAMgAAAAAAAABkAAAAAAAAAH9/fwAKAAAAIgAAABgAAAAAAAAAAAAAAAAAAAAAAAAAAAAAAAAAAAAkAAAAJAAAAAAAAAAHAAAAAAAAAAAAAAAAAAAAAAAAAAAAAAAAAAAAf39/ACUAAABYAAAAAAAAAAAAAAAAAAAAAAAAAAAAAAAAAAAAAAAAAAAAAAAAAAAAAAAAAAAAAAA/AAAAAAAAAKCGAQAAAAAAAAAAAAAAAAAMAAAAAQAAAAAAAAAAAAAAAAAAAB8AAABUAAAAAAAABQAAAAEAAAAAAAAAAAAAAAAAAAAAAAAAAAAAAAAAAAAAAAAAAAAAAAJ/f38AAAAAA8zMzADAwP8Af39/AAAAAAAAAAAAAAAAAAAAAAAAAAAAIQAAABgAAAAUAAAAXAgAALAKAAAUJAAAtiYAABAgAAAmAAAACAAAAD2wAAAAAAAA"/>
               </a:ext>
             </a:extLst>
           </p:cNvSpPr>
@@ -6344,7 +6224,7 @@
             <a:spLocks noGrp="1" noChangeArrowheads="1"/>
             <a:extLst>
               <a:ext uri="smNativeData">
-                <pr:smNativeData xmlns:pr="smNativeData" xmlns="smNativeData" val="SMDATA_15_EkJ5ZhMAAAAlAAAAZAAAAA0AAAAAkAAAAJAAAACQAAAAkAAAAAAAAAABAAAAAAAAAAEAAABQAAAAAAAAAAAA4D8AAAAAAADgPwAAAAAAAOA/AAAAAAAA4D8AAAAAAADgPwAAAAAAAOA/AAAAAAAA4D8AAAAAAADgPwAAAAAAAOA/AAAAAAAA4D8CAAAAjAAAAAAAAAAAAAAAQoX0DP///wgAAAAAAAAAAAAAAAAAAAAAAAAAAAAAAAAAAAAAZAAAAAEAAABAAAAAAAAAAAAAAAAAAAAAAAAAAAAAAAAAAAAAAAAAAAAAAAAAAAAAAAAAAAAAAAAAAAAAAAAAAAAAAAAAAAAAAAAAAAAAAAAAAAAAAAAAAAAAAAAAAAAAFAAAADwAAAAAAAAAAAAAAAAAAAkUAAAAAQAAABQAAAAUAAAAFAAAAAEAAAAAAAAAZAAAAGQAAAAAAAAAZAAAAGQAAAAVAAAAYAAAAAAAAAAAAAAADwAAACADAAAAAAAAAAAAAAEAAACgMgAAVgcAAKr4//8BAAAAf39/AAEAAABkAAAAAAAAABQAAABAHwAAAAAAACYAAAAAAAAAwOD//wAAAAAmAAAAZAAAABYAAABMAAAAAAAAAAAAAAAEAAAAAAAAAAEAAABZWVkKAAAAACgAAAAoAAAAZAAAAGQAAAAAAAAAzMzMAAAAAABQAAAAUAAAAGQAAABkAAAAAAAAABcAAAAUAAAAAAAAAAAAAAD/fwAA/38AAAAAAAAJAAAABAAAAAAAAAAeAAAAaAAAAAAAAAAAAAAAAAAAAAAAAAAAAAAAECcAABAnAAAAAAAAAAAAAAAAAAAAAAAAAAAAAAAAAAAAAAAAAAAAABQAAAAAAAAAwMD/AAAAAABkAAAAMgAAAAAAAABkAAAAAAAAAH9/fwAKAAAAIgAAABgAAAAAAAAAAAAAAAAAAAAAAAAAAAAAAAAAAAAkAAAAJAAAAAAAAAAHAAAAAAAAAAAAAAAAAAAAAAAAAAAAAAAAAAAAf39/ACUAAABYAAAAAAAAAAAAAAAAAAAAAAAAAAAAAAAAAAAAAAAAAAAAAAAAAAAAAAAAAAAAAAA/AAAAAAAAAKCGAQAAAAAAAAAAAAAAAAAMAAAAAQAAAAAAAAAAAAAAAAAAAB8AAABUAAAAAAAABQAAAAEAAAAAAAAAAAAAAAAAAAAAAAAAAAAAAAAAAAAAAAAAAAAAAAJ/f38AAAAAA8zMzADAwP8Af39/AAAAAAAAAAAAAAAAAAAAAAAAAAAAIQAAABgAAAAUAAAAHjQAAEAmAAB/NwAAeikAABAAAAAmAAAACAAAADywAAAAAAAA"/>
+                <pr:smNativeData xmlns:pr="smNativeData" xmlns="smNativeData" val="SMDATA_15_LkR5ZhMAAAAlAAAAZAAAAA0AAAAAkAAAAJAAAACQAAAAkAAAAAAAAAABAAAAAAAAAAEAAABQAAAAAAAAAAAA4D8AAAAAAADgPwAAAAAAAOA/AAAAAAAA4D8AAAAAAADgPwAAAAAAAOA/AAAAAAAA4D8AAAAAAADgPwAAAAAAAOA/AAAAAAAA4D8CAAAAjAAAAAAAAAAAAAAAQoX0DP///wgAAAAAAAAAAAAAAAAAAAAAAAAAAAAAAAAAAAAAZAAAAAEAAABAAAAAAAAAAAAAAAAAAAAAAAAAAAAAAAAAAAAAAAAAAAAAAAAAAAAAAAAAAAAAAAAAAAAAAAAAAAAAAAAAAAAAAAAAAAAAAAAAAAAAAAAAAAAAAAAAAAAAFAAAADwAAAAAAAAAAAAAAAAAAAkUAAAAAQAAABQAAAAUAAAAFAAAAAEAAAAAAAAAZAAAAGQAAAAAAAAAZAAAAGQAAAAVAAAAYAAAAAAAAAAAAAAADwAAACADAAAAAAAAAAAAAAEAAACgMgAAVgcAAKr4//8BAAAAf39/AAEAAABkAAAAAAAAABQAAABAHwAAAAAAACYAAAAAAAAAwOD//wAAAAAmAAAAZAAAABYAAABMAAAAAAAAAAAAAAAEAAAAAAAAAAEAAABZWVkKAAAAACgAAAAoAAAAZAAAAGQAAAAAAAAAzMzMAAAAAABQAAAAUAAAAGQAAABkAAAAAAAAABcAAAAUAAAAAAAAAAAAAAD/fwAA/38AAAAAAAAJAAAABAAAAAAAAAAeAAAAaAAAAAAAAAAAAAAAAAAAAAAAAAAAAAAAECcAABAnAAAAAAAAAAAAAAAAAAAAAAAAAAAAAAAAAAAAAAAAAAAAABQAAAAAAAAAwMD/AAAAAABkAAAAMgAAAAAAAABkAAAAAAAAAH9/fwAKAAAAIgAAABgAAAAAAAAAAAAAAAAAAAAAAAAAAAAAAAAAAAAkAAAAJAAAAAAAAAAHAAAAAAAAAAAAAAAAAAAAAAAAAAAAAAAAAAAAf39/ACUAAABYAAAAAAAAAAAAAAAAAAAAAAAAAAAAAAAAAAAAAAAAAAAAAAAAAAAAAAAAAAAAAAA/AAAAAAAAAKCGAQAAAAAAAAAAAAAAAAAMAAAAAQAAAAAAAAAAAAAAAAAAAB8AAABUAAAAAAAABQAAAAEAAAAAAAAAAAAAAAAAAAAAAAAAAAAAAAAAAAAAAAAAAAAAAAJ/f38AAAAAA8zMzADAwP8Af39/AAAAAAAAAAAAAAAAAAAAAAAAAAAAIQAAABgAAAAUAAAAHjQAAEAmAAB/NwAAeikAABAAAAAmAAAACAAAADywAAAAAAAA"/>
               </a:ext>
             </a:extLst>
           </p:cNvSpPr>
@@ -6398,10 +6278,11 @@
               </a:spcAft>
               <a:buNone/>
             </a:pPr>
-            <a:fld id="{3FC25D6B-25D2-97AB-9C7A-D3FE13346A86}" type="slidenum">
+            <a:fld id="{3FDAD9DC-92D2-8F2F-9C62-647A972C6A31}" type="slidenum">
               <a:rPr lang="ru-ru" cap="none"/>
               <a:t/>
             </a:fld>
+            <a:endParaRPr lang="ru-ru" cap="none"/>
           </a:p>
         </p:txBody>
       </p:sp>
@@ -6411,7 +6292,7 @@
           <p:cNvPicPr>
             <a:extLst>
               <a:ext uri="smNativeData">
-                <pr:smNativeData xmlns:pr="smNativeData" xmlns="smNativeData" val="SMDATA_17_EkJ5ZhMAAAAlAAAAEQAAAA0AAAAAkAAAAEgAAACQAAAASAAAAAAAAAAAAAAAAAAAAAEAAABQAAAAAAAAAAAA4D8AAAAAAADgPwAAAAAAAOA/AAAAAAAA4D8AAAAAAADgPwAAAAAAAOA/AAAAAAAA4D8AAAAAAADgPwAAAAAAAOA/AAAAAAAA4D8CAAAAjAAAAAAAAAAAAAAAQoX0DP///wgAAAAAAAAAAAAAAAAAAAAAAAAAAAAAAAAAAAAAZAAAAAEAAABAAAAAAAAAAAAAAAAAAAAAAAAAAAAAAAAAAAAAAAAAAAAAAAAAAAAAAAAAAAAAAAAAAAAAAAAAAAAAAAAAAAAAAAAAAAAAAAAAAAAAAAAAAAAAAAAAAAAAFAAAADwAAAAAAAAAAAAAAAAAAAkUAAAAAQAAABQAAAAUAAAAFAAAAAEAAAAAAAAAZAAAAGQAAAAAAAAAZAAAAGQAAAAVAAAAYAAAAAAAAAAAAAAADwAAACADAAAAAAAAAAAAAAEAAACgMgAAVgcAAKr4//8BAAAAf39/AAEAAABkAAAAAAAAABQAAABAHwAAAAAAACYAAAAAAAAAwOD//wAAAAAmAAAAZAAAABYAAABMAAAAAAAAAAAAAAAEAAAAAAAAAAEAAABZWVkKAAAAACgAAAAoAAAAZAAAAGQAAAAAAAAAzMzMAAAAAABQAAAAUAAAAGQAAABkAAAAAAAAAAcAAAA4AAAAAAAAAAAAAAAAAAAA////AAAAAAAAAAAAAAAAAAAAAAAAAAAAAAAAAAAAAABkAAAAZAAAAAAAAAAjAAAABAAAAGQAAAAXAAAAFAAAAAAAAAAAAAAA/38AAP9/AAAAAAAACQAAAAQAAACwmIhjHgAAAGgAAAAAAAAAAAAAAAAAAAAAAAAAAAAAABAnAAAQJwAAAAAAAAAAAAAAAAAAAAAAAAAAAAAAAAAAAAAAAAAAAAAUAAAAAAAAAMDA/wAAAAAAZAAAADIAAAAAAAAAZAAAAAAAAAB/f38ACgAAACIAAAAYAAAAAAAAAAAAAAAAAAAAAAAAAAAAAAAAAAAAJAAAACQAAAAAAAAABwAAAAAAAAAAAAAAAAAAAAAAAAAAAAAAAAAAAH9/fwAlAAAAWAAAAAAAAAAAAAAAAAAAAAAAAAAAAAAAAAAAAAAAAAAAAAAAAAAAAAAAAAAAAAAAPwAAAAAAAACghgEAAAAAAAAAAAAAAAAADAAAAAEAAAAAAAAAAAAAAAAAAAAfAAAAVAAAAEKF9AX///8BAAAAAAAAAAAAAAAAAAAAAAAAAAAAAAAAAAAAAAAAAAAAAAACf39/AFlZWQPMzMwAwMD/AH9/fwAAAAAAAAAAAAAAAAD///8AAAAAACEAAAAYAAAAFAAAAAAAAAAAAAAAQDgAADAqAAAQAAAAJgAAAAgAAAD//////////w=="/>
+                <pr:smNativeData xmlns:pr="smNativeData" xmlns="smNativeData" val="SMDATA_17_LkR5ZhMAAAAlAAAAEQAAAA0AAAAAkAAAAEgAAACQAAAASAAAAAAAAAAAAAAAAAAAAAEAAABQAAAAAAAAAAAA4D8AAAAAAADgPwAAAAAAAOA/AAAAAAAA4D8AAAAAAADgPwAAAAAAAOA/AAAAAAAA4D8AAAAAAADgPwAAAAAAAOA/AAAAAAAA4D8CAAAAjAAAAAAAAAAAAAAAQoX0DP///wgAAAAAAAAAAAAAAAAAAAAAAAAAAAAAAAAAAAAAZAAAAAEAAABAAAAAAAAAAAAAAAAAAAAAAAAAAAAAAAAAAAAAAAAAAAAAAAAAAAAAAAAAAAAAAAAAAAAAAAAAAAAAAAAAAAAAAAAAAAAAAAAAAAAAAAAAAAAAAAAAAAAAFAAAADwAAAAAAAAAAAAAAAAAAAkUAAAAAQAAABQAAAAUAAAAFAAAAAEAAAAAAAAAZAAAAGQAAAAAAAAAZAAAAGQAAAAVAAAAYAAAAAAAAAAAAAAADwAAACADAAAAAAAAAAAAAAEAAACgMgAAVgcAAKr4//8BAAAAf39/AAEAAABkAAAAAAAAABQAAABAHwAAAAAAACYAAAAAAAAAwOD//wAAAAAmAAAAZAAAABYAAABMAAAAAAAAAAAAAAAEAAAAAAAAAAEAAABZWVkKAAAAACgAAAAoAAAAZAAAAGQAAAAAAAAAzMzMAAAAAABQAAAAUAAAAGQAAABkAAAAAAAAAAcAAAA4AAAAAAAAAAAAAAAAAAAA////AAAAAAAAAAAAAAAAAAAAAAAAAAAAAAAAAAAAAABkAAAAZAAAAAAAAAAjAAAABAAAAGQAAAAXAAAAFAAAAAAAAAAAAAAA/38AAP9/AAAAAAAACQAAAAQAAACwmIhjHgAAAGgAAAAAAAAAAAAAAAAAAAAAAAAAAAAAABAnAAAQJwAAAAAAAAAAAAAAAAAAAAAAAAAAAAAAAAAAAAAAAAAAAAAUAAAAAAAAAMDA/wAAAAAAZAAAADIAAAAAAAAAZAAAAAAAAAB/f38ACgAAACIAAAAYAAAAAAAAAAAAAAAAAAAAAAAAAAAAAAAAAAAAJAAAACQAAAAAAAAABwAAAAAAAAAAAAAAAAAAAAAAAAAAAAAAAAAAAH9/fwAlAAAAWAAAAAAAAAAAAAAAAAAAAAAAAAAAAAAAAAAAAAAAAAAAAAAAAAAAAAAAAAAAAAAAPwAAAAAAAACghgEAAAAAAAAAAAAAAAAADAAAAAEAAAAAAAAAAAAAAAAAAAAfAAAAVAAAAEKF9AX///8BAAAAAAAAAAAAAAAAAAAAAAAAAAAAAAAAAAAAAAAAAAAAAAACf39/AFlZWQPMzMwAwMD/AH9/fwAAAAAAAAAAAAAAAAD///8AAAAAACEAAAAYAAAAFAAAAAAAAAAAAAAAQDgAADAqAAAQAAAAJgAAAAgAAAD//////////w=="/>
               </a:ext>
             </a:extLst>
           </p:cNvPicPr>
@@ -6445,7 +6326,7 @@
             <a:spLocks noGrp="1" noChangeArrowheads="1"/>
             <a:extLst>
               <a:ext uri="smNativeData">
-                <pr:smNativeData xmlns:pr="smNativeData" xmlns="smNativeData" val="SMDATA_15_EkJ5ZhMAAAAlAAAAZAAAAA0AAAAAkAAAAJAAAACQAAAAkAAAAAAAAAABAAAAAAAAAAEAAABQAAAAAAAAAAAA4D8AAAAAAADgPwAAAAAAAOA/AAAAAAAA4D8AAAAAAADgPwAAAAAAAOA/AAAAAAAA4D8AAAAAAADgPwAAAAAAAOA/AAAAAAAA4D8CAAAAjAAAAAAAAAAAAAAAQoX0DP///wgAAAAAAAAAAAAAAAAAAAAAAAAAAAAAAAAAAAAAZAAAAAEAAABAAAAAAAAAAAAAAAAAAAAAAAAAAAAAAAAAAAAAAAAAAAAAAAAAAAAAAAAAAAAAAAAAAAAAAAAAAAAAAAAAAAAAAAAAAAAAAAAAAAAAAAAAAAAAAAAAAAAAFAAAADwAAAAAAAAAAAAAAAAAAAkUAAAAAQAAABQAAAAUAAAAFAAAAAEAAAAAAAAAZAAAAGQAAAAAAAAAZAAAAGQAAAAVAAAAYAAAAAAAAAAAAAAADwAAACADAAAAAAAAAAAAAAEAAACgMgAAVgcAAKr4//8BAAAAf39/AAEAAABkAAAAAAAAABQAAABAHwAAAAAAACYAAAAAAAAAwOD//wAAAAAmAAAAZAAAABYAAABMAAAAAAAAAAAAAAAEAAAAAAAAAAEAAABZWVkKAAAAACgAAAAoAAAAZAAAAGQAAAAAAAAAzMzMAAAAAABQAAAAUAAAAGQAAABkAAAAAAAAABcAAAAUAAAAAAAAAAAAAAD/fwAA/38AAAAAAAAJAAAABAAAAG0AOwAeAAAAaAAAAAAAAAAAAAAAAAAAAAAAAAAAAAAAECcAABAnAAAAAAAAAAAAAAAAAAAAAAAAAAAAAAAAAAAAAAAAAAAAABQAAAAAAAAAwMD/AAAAAABkAAAAMgAAAAAAAABkAAAAAAAAAH9/fwAKAAAAIgAAABgAAAAAAAAAAAAAAAAAAAAAAAAAAAAAAAAAAAAkAAAAJAAAAAAAAAAHAAAAAAAAAAAAAAAAAAAAAAAAAAAAAAAAAAAAf39/ACUAAABYAAAAAAAAAAAAAAAAAAAAAAAAAAAAAAAAAAAAAAAAAAAAAAAAAAAAAAAAAAAAAAA/AAAAAAAAAKCGAQAAAAAAAAAAAAAAAAAMAAAAAQAAAAAAAAAAAAAAAAAAAB8AAABUAAAAAAAABQAAAAEAAAAAAAAAAAAAAAAAAAAAAAAAAAAAAAAAAAAAAAAAAAAAAAJ/f38AAAAAA8zMzADAwP8Af39/AAAAAAAAAAAAAAAAAAAAAAAAAAAAIQAAABgAAAAUAAAA4gUAAEADAAA5NQAAziQAABAAAAAmAAAACAAAAL2wAAAAAAAA"/>
+                <pr:smNativeData xmlns:pr="smNativeData" xmlns="smNativeData" val="SMDATA_15_LkR5ZhMAAAAlAAAAZAAAAA0AAAAAkAAAAJAAAACQAAAAkAAAAAAAAAABAAAAAAAAAAEAAABQAAAAAAAAAAAA4D8AAAAAAADgPwAAAAAAAOA/AAAAAAAA4D8AAAAAAADgPwAAAAAAAOA/AAAAAAAA4D8AAAAAAADgPwAAAAAAAOA/AAAAAAAA4D8CAAAAjAAAAAAAAAAAAAAAQoX0DP///wgAAAAAAAAAAAAAAAAAAAAAAAAAAAAAAAAAAAAAZAAAAAEAAABAAAAAAAAAAAAAAAAAAAAAAAAAAAAAAAAAAAAAAAAAAAAAAAAAAAAAAAAAAAAAAAAAAAAAAAAAAAAAAAAAAAAAAAAAAAAAAAAAAAAAAAAAAAAAAAAAAAAAFAAAADwAAAAAAAAAAAAAAAAAAAkUAAAAAQAAABQAAAAUAAAAFAAAAAEAAAAAAAAAZAAAAGQAAAAAAAAAZAAAAGQAAAAVAAAAYAAAAAAAAAAAAAAADwAAACADAAAAAAAAAAAAAAEAAACgMgAAVgcAAKr4//8BAAAAf39/AAEAAABkAAAAAAAAABQAAABAHwAAAAAAACYAAAAAAAAAwOD//wAAAAAmAAAAZAAAABYAAABMAAAAAAAAAAAAAAAEAAAAAAAAAAEAAABZWVkKAAAAACgAAAAoAAAAZAAAAGQAAAAAAAAAzMzMAAAAAABQAAAAUAAAAGQAAABkAAAAAAAAABcAAAAUAAAAAAAAAAAAAAD/fwAA/38AAAAAAAAJAAAABAAAAG0AOwAeAAAAaAAAAAAAAAAAAAAAAAAAAAAAAAAAAAAAECcAABAnAAAAAAAAAAAAAAAAAAAAAAAAAAAAAAAAAAAAAAAAAAAAABQAAAAAAAAAwMD/AAAAAABkAAAAMgAAAAAAAABkAAAAAAAAAH9/fwAKAAAAIgAAABgAAAAAAAAAAAAAAAAAAAAAAAAAAAAAAAAAAAAkAAAAJAAAAAAAAAAHAAAAAAAAAAAAAAAAAAAAAAAAAAAAAAAAAAAAf39/ACUAAABYAAAAAAAAAAAAAAAAAAAAAAAAAAAAAAAAAAAAAAAAAAAAAAAAAAAAAAAAAAAAAAA/AAAAAAAAAKCGAQAAAAAAAAAAAAAAAAAMAAAAAQAAAAAAAAAAAAAAAAAAAB8AAABUAAAAAAAABQAAAAEAAAAAAAAAAAAAAAAAAAAAAAAAAAAAAAAAAAAAAAAAAAAAAAJ/f38AAAAAA8zMzADAwP8Af39/AAAAAAAAAAAAAAAAAAAAAAAAAAAAIQAAABgAAAAUAAAA4gUAAEADAAA5NQAAziQAABAAAAAmAAAACAAAAL2wAAAAAAAA"/>
               </a:ext>
             </a:extLst>
           </p:cNvSpPr>
@@ -6599,7 +6480,7 @@
             <a:spLocks noGrp="1" noChangeArrowheads="1"/>
             <a:extLst>
               <a:ext uri="smNativeData">
-                <pr:smNativeData xmlns:pr="smNativeData" xmlns="smNativeData" val="SMDATA_15_EkJ5ZhMAAAAlAAAAZAAAAA0AAAAAkAAAAJAAAACQAAAAkAAAAAAAAAAAAAAAAAAAAAEAAABQAAAAAAAAAAAA4D8AAAAAAADgPwAAAAAAAOA/AAAAAAAA4D8AAAAAAADgPwAAAAAAAOA/AAAAAAAA4D8AAAAAAADgPwAAAAAAAOA/AAAAAAAA4D8CAAAAjAAAAAAAAAAAAAAAQoX0DP///wgAAAAAAAAAAAAAAAAAAAAAAAAAAAAAAAAAAAAAZAAAAAEAAABAAAAAAAAAAAAAAAAAAAAAAAAAAAAAAAAAAAAAAAAAAAAAAAAAAAAAAAAAAAAAAAAAAAAAAAAAAAAAAAAAAAAAAAAAAAAAAAAAAAAAAAAAAAAAAAAAAAAAFAAAADwAAAAAAAAAAAAAAAAAAAkUAAAAAQAAABQAAAAUAAAAFAAAAAEAAAAAAAAAZAAAAGQAAAAAAAAAZAAAAGQAAAAVAAAAYAAAAAAAAAAAAAAADwAAACADAAAAAAAAAAAAAAEAAACgMgAAVgcAAKr4//8BAAAAf39/AAEAAABkAAAAAAAAABQAAABAHwAAAAAAACYAAAAAAAAAwOD//wAAAAAmAAAAZAAAABYAAABMAAAAAAAAAAAAAAAEAAAAAAAAAAEAAABZWVkKAAAAACgAAAAoAAAAZAAAAGQAAAAAAAAAzMzMAAAAAABQAAAAUAAAAGQAAABkAAAAAAAAABcAAAAUAAAAAAAAAAAAAAD/fwAA/38AAAAAAAAJAAAABAAAAF0AXgAeAAAAaAAAAAAAAAAAAAAAAAAAAAAAAAAAAAAAECcAABAnAAAAAAAAAAAAAAAAAAAAAAAAAAAAAAAAAAAAAAAAAAAAABQAAAAAAAAAwMD/AAAAAABkAAAAMgAAAAAAAABkAAAAAAAAAH9/fwAKAAAAIgAAABgAAAAAAAAAAAAAAAAAAAAAAAAAAAAAAAAAAAAkAAAAJAAAAAAAAAAHAAAAAAAAAAAAAAAAAAAAAAAAAAAAAAAAAAAAf39/ACUAAABYAAAAAAAAAAAAAAAAAAAAAAAAAAAAAAAAAAAAAAAAAAAAAAAAAAAAAAAAAAAAAAA/AAAAAAAAAKCGAQAAAAAAAAAAAAAAAAAMAAAAAQAAAAAAAAAAAAAAAAAAAB8AAABUAAAAAAAABQAAAAEAAAAAAAAAAAAAAAAAAAAAAAAAAAAAAAAAAAAAAAAAAAAAAAJ/f38AAAAAA8zMzADAwP8Af39/AAAAAAAAAAAAAAAAAAAAAAAAAAAAIQAAABgAAAAUAAAAFAMAALYCAAB/NwAAvwoAABAAAAAmAAAACAAAADywAAAAAAAA"/>
+                <pr:smNativeData xmlns:pr="smNativeData" xmlns="smNativeData" val="SMDATA_15_LkR5ZhMAAAAlAAAAZAAAAA0AAAAAkAAAAJAAAACQAAAAkAAAAAAAAAAAAAAAAAAAAAEAAABQAAAAAAAAAAAA4D8AAAAAAADgPwAAAAAAAOA/AAAAAAAA4D8AAAAAAADgPwAAAAAAAOA/AAAAAAAA4D8AAAAAAADgPwAAAAAAAOA/AAAAAAAA4D8CAAAAjAAAAAAAAAAAAAAAQoX0DP///wgAAAAAAAAAAAAAAAAAAAAAAAAAAAAAAAAAAAAAZAAAAAEAAABAAAAAAAAAAAAAAAAAAAAAAAAAAAAAAAAAAAAAAAAAAAAAAAAAAAAAAAAAAAAAAAAAAAAAAAAAAAAAAAAAAAAAAAAAAAAAAAAAAAAAAAAAAAAAAAAAAAAAFAAAADwAAAAAAAAAAAAAAAAAAAkUAAAAAQAAABQAAAAUAAAAFAAAAAEAAAAAAAAAZAAAAGQAAAAAAAAAZAAAAGQAAAAVAAAAYAAAAAAAAAAAAAAADwAAACADAAAAAAAAAAAAAAEAAACgMgAAVgcAAKr4//8BAAAAf39/AAEAAABkAAAAAAAAABQAAABAHwAAAAAAACYAAAAAAAAAwOD//wAAAAAmAAAAZAAAABYAAABMAAAAAAAAAAAAAAAEAAAAAAAAAAEAAABZWVkKAAAAACgAAAAoAAAAZAAAAGQAAAAAAAAAzMzMAAAAAABQAAAAUAAAAGQAAABkAAAAAAAAABcAAAAUAAAAAAAAAAAAAAD/fwAA/38AAAAAAAAJAAAABAAAAF0AXgAeAAAAaAAAAAAAAAAAAAAAAAAAAAAAAAAAAAAAECcAABAnAAAAAAAAAAAAAAAAAAAAAAAAAAAAAAAAAAAAAAAAAAAAABQAAAAAAAAAwMD/AAAAAABkAAAAMgAAAAAAAABkAAAAAAAAAH9/fwAKAAAAIgAAABgAAAAAAAAAAAAAAAAAAAAAAAAAAAAAAAAAAAAkAAAAJAAAAAAAAAAHAAAAAAAAAAAAAAAAAAAAAAAAAAAAAAAAAAAAf39/ACUAAABYAAAAAAAAAAAAAAAAAAAAAAAAAAAAAAAAAAAAAAAAAAAAAAAAAAAAAAAAAAAAAAA/AAAAAAAAAKCGAQAAAAAAAAAAAAAAAAAMAAAAAQAAAAAAAAAAAAAAAAAAAB8AAABUAAAAAAAABQAAAAEAAAAAAAAAAAAAAAAAAAAAAAAAAAAAAAAAAAAAAAAAAAAAAAJ/f38AAAAAA8zMzADAwP8Af39/AAAAAAAAAAAAAAAAAAAAAAAAAAAAIQAAABgAAAAUAAAAFAMAALYCAAB/NwAAvwoAABAAAAAmAAAACAAAADywAAAAAAAA"/>
               </a:ext>
             </a:extLst>
           </p:cNvSpPr>
@@ -6709,7 +6590,7 @@
             <a:spLocks noGrp="1" noChangeArrowheads="1"/>
             <a:extLst>
               <a:ext uri="smNativeData">
-                <pr:smNativeData xmlns:pr="smNativeData" xmlns="smNativeData" val="SMDATA_15_EkJ5ZhMAAAAlAAAAZAAAAA0AAAAAkAAAAJAAAACQAAAAkAAAAAAAAAAAAAAAAAAAAAEAAABQAAAAAAAAAAAA4D8AAAAAAADgPwAAAAAAAOA/AAAAAAAA4D8AAAAAAADgPwAAAAAAAOA/AAAAAAAA4D8AAAAAAADgPwAAAAAAAOA/AAAAAAAA4D8CAAAAjAAAAAAAAAAAAAAAQoX0DP///wgAAAAAAAAAAAAAAAAAAAAAAAAAAAAAAAAAAAAAZAAAAAEAAABAAAAAAAAAAAAAAAAAAAAAAAAAAAAAAAAAAAAAAAAAAAAAAAAAAAAAAAAAAAAAAAAAAAAAAAAAAAAAAAAAAAAAAAAAAAAAAAAAAAAAAAAAAAAAAAAAAAAAFAAAADwAAAAAAAAAAAAAAAAAAAkUAAAAAQAAABQAAAAUAAAAFAAAAAEAAAAAAAAAZAAAAGQAAAAAAAAAZAAAAGQAAAAVAAAAYAAAAAAAAAAAAAAADwAAACADAAAAAAAAAAAAAAEAAACgMgAAVgcAAKr4//8BAAAAf39/AAEAAABkAAAAAAAAABQAAABAHwAAAAAAACYAAAAAAAAAwOD//wAAAAAmAAAAZAAAABYAAABMAAAAAAAAAAAAAAAEAAAAAAAAAAEAAABZWVkKAAAAACgAAAAoAAAAZAAAAGQAAAAAAAAAzMzMAAAAAABQAAAAUAAAAGQAAABkAAAAAAAAABcAAAAUAAAAAAAAAAAAAAD/fwAA/38AAAAAAAAJAAAABAAAAAAAAAAeAAAAaAAAAAAAAAAAAAAAAAAAAAAAAAAAAAAAECcAABAnAAAAAAAAAAAAAAAAAAAAAAAAAAAAAAAAAAAAAAAAAAAAABQAAAAAAAAAwMD/AAAAAABkAAAAMgAAAAAAAABkAAAAAAAAAH9/fwAKAAAAIgAAABgAAAAAAAAAAAAAAAAAAAAAAAAAAAAAAAAAAAAkAAAAJAAAAAAAAAAHAAAAAAAAAAAAAAAAAAAAAAAAAAAAAAAAAAAAf39/ACUAAABYAAAAAAAAAAAAAAAAAAAAAAAAAAAAAAAAAAAAAAAAAAAAAAAAAAAAAAAAAAAAAAA/AAAAAAAAAKCGAQAAAAAAAAAAAAAAAAAMAAAAAQAAAAAAAAAAAAAAAAAAAB8AAABUAAAAAAAABQAAAAEAAAAAAAAAAAAAAAAAAAAAAAAAAAAAAAAAAAAAAAAAAAAAAAJ/f38AAAAAA8zMzADAwP8Af39/AAAAAAAAAAAAAAAAAAAAAAAAAAAAIQAAABgAAAAUAAAAwRoAAJQQAADFNQAAZRUAABAAAAAmAAAACAAAAD2wAAAAAAAA"/>
+                <pr:smNativeData xmlns:pr="smNativeData" xmlns="smNativeData" val="SMDATA_15_LkR5ZhMAAAAlAAAAZAAAAA0AAAAAkAAAAJAAAACQAAAAkAAAAAAAAAAAAAAAAAAAAAEAAABQAAAAAAAAAAAA4D8AAAAAAADgPwAAAAAAAOA/AAAAAAAA4D8AAAAAAADgPwAAAAAAAOA/AAAAAAAA4D8AAAAAAADgPwAAAAAAAOA/AAAAAAAA4D8CAAAAjAAAAAAAAAAAAAAAQoX0DP///wgAAAAAAAAAAAAAAAAAAAAAAAAAAAAAAAAAAAAAZAAAAAEAAABAAAAAAAAAAAAAAAAAAAAAAAAAAAAAAAAAAAAAAAAAAAAAAAAAAAAAAAAAAAAAAAAAAAAAAAAAAAAAAAAAAAAAAAAAAAAAAAAAAAAAAAAAAAAAAAAAAAAAFAAAADwAAAAAAAAAAAAAAAAAAAkUAAAAAQAAABQAAAAUAAAAFAAAAAEAAAAAAAAAZAAAAGQAAAAAAAAAZAAAAGQAAAAVAAAAYAAAAAAAAAAAAAAADwAAACADAAAAAAAAAAAAAAEAAACgMgAAVgcAAKr4//8BAAAAf39/AAEAAABkAAAAAAAAABQAAABAHwAAAAAAACYAAAAAAAAAwOD//wAAAAAmAAAAZAAAABYAAABMAAAAAAAAAAAAAAAEAAAAAAAAAAEAAABZWVkKAAAAACgAAAAoAAAAZAAAAGQAAAAAAAAAzMzMAAAAAABQAAAAUAAAAGQAAABkAAAAAAAAABcAAAAUAAAAAAAAAAAAAAD/fwAA/38AAAAAAAAJAAAABAAAAAAAAAAeAAAAaAAAAAAAAAAAAAAAAAAAAAAAAAAAAAAAECcAABAnAAAAAAAAAAAAAAAAAAAAAAAAAAAAAAAAAAAAAAAAAAAAABQAAAAAAAAAwMD/AAAAAABkAAAAMgAAAAAAAABkAAAAAAAAAH9/fwAKAAAAIgAAABgAAAAAAAAAAAAAAAAAAAAAAAAAAAAAAAAAAAAkAAAAJAAAAAAAAAAHAAAAAAAAAAAAAAAAAAAAAAAAAAAAAAAAAAAAf39/ACUAAABYAAAAAAAAAAAAAAAAAAAAAAAAAAAAAAAAAAAAAAAAAAAAAAAAAAAAAAAAAAAAAAA/AAAAAAAAAKCGAQAAAAAAAAAAAAAAAAAMAAAAAQAAAAAAAAAAAAAAAAAAAB8AAABUAAAAAAAABQAAAAEAAAAAAAAAAAAAAAAAAAAAAAAAAAAAAAAAAAAAAAAAAAAAAAJ/f38AAAAAA8zMzADAwP8Af39/AAAAAAAAAAAAAAAAAAAAAAAAAAAAIQAAABgAAAAUAAAAwRoAAJQQAADFNQAAZRUAABAAAAAmAAAACAAAAD2wAAAAAAAA"/>
               </a:ext>
             </a:extLst>
           </p:cNvSpPr>
@@ -6896,7 +6777,7 @@
             <a:spLocks noGrp="1" noChangeArrowheads="1"/>
             <a:extLst>
               <a:ext uri="smNativeData">
-                <pr:smNativeData xmlns:pr="smNativeData" xmlns="smNativeData" val="SMDATA_15_EkJ5ZhMAAAAlAAAAZAAAAA0AAAAAkAAAAJAAAACQAAAAkAAAAAAAAAAAAAAAAAAAAAEAAABQAAAAAAAAAAAA4D8AAAAAAADgPwAAAAAAAOA/AAAAAAAA4D8AAAAAAADgPwAAAAAAAOA/AAAAAAAA4D8AAAAAAADgPwAAAAAAAOA/AAAAAAAA4D8CAAAAjAAAAAAAAAAAAAAAQoX0DP///wgAAAAAAAAAAAAAAAAAAAAAAAAAAAAAAAAAAAAAZAAAAAEAAABAAAAAAAAAAAAAAAAAAAAAAAAAAAAAAAAAAAAAAAAAAAAAAAAAAAAAAAAAAAAAAAAAAAAAAAAAAAAAAAAAAAAAAAAAAAAAAAAAAAAAAAAAAAAAAAAAAAAAFAAAADwAAAAAAAAAAAAAAAAAAAkUAAAAAQAAABQAAAAUAAAAFAAAAAEAAAAAAAAAZAAAAGQAAAAAAAAAZAAAAGQAAAAVAAAAYAAAAAAAAAAAAAAADwAAACADAAAAAAAAAAAAAAEAAACgMgAAVgcAAKr4//8BAAAAf39/AAEAAABkAAAAAAAAABQAAABAHwAAAAAAACYAAAAAAAAAwOD//wAAAAAmAAAAZAAAABYAAABMAAAAAAAAAAAAAAAEAAAAAAAAAAEAAABZWVkKAAAAACgAAAAoAAAAZAAAAGQAAAAAAAAAzMzMAAAAAABQAAAAUAAAAGQAAABkAAAAAAAAABcAAAAUAAAAAAAAAAAAAAD/fwAA/38AAAAAAAAJAAAABAAAAAAAAAAeAAAAaAAAAAAAAAAAAAAAAAAAAAAAAAAAAAAAECcAABAnAAAAAAAAAAAAAAAAAAAAAAAAAAAAAAAAAAAAAAAAAAAAABQAAAAAAAAAwMD/AAAAAABkAAAAMgAAAAAAAABkAAAAAAAAAH9/fwAKAAAAIgAAABgAAAAAAAAAAAAAAAAAAAAAAAAAAAAAAAAAAAAkAAAAJAAAAAAAAAAHAAAAAAAAAAAAAAAAAAAAAAAAAAAAAAAAAAAAf39/ACUAAABYAAAAAAAAAAAAAAAAAAAAAAAAAAAAAAAAAAAAAAAAAAAAAAAAAAAAAAAAAAAAAAA/AAAAAAAAAKCGAQAAAAAAAAAAAAAAAAAMAAAAAQAAAAAAAAAAAAAAAAAAAB8AAABUAAAAAAAABQAAAAEAAAAAAAAAAAAAAAAAAAAAAAAAAAAAAAAAAAAAAAAAAAAAAAJ/f38AAAAAA8zMzADAwP8Af39/AAAAAAAAAAAAAAAAAAAAAAAAAAAAIQAAABgAAAAUAAAAwRoAAPoUAAD6NgAAtCUAABAAAAAmAAAACAAAAD2wAAAAAAAA"/>
+                <pr:smNativeData xmlns:pr="smNativeData" xmlns="smNativeData" val="SMDATA_15_LkR5ZhMAAAAlAAAAZAAAAA0AAAAAkAAAAJAAAACQAAAAkAAAAAAAAAAAAAAAAAAAAAEAAABQAAAAAAAAAAAA4D8AAAAAAADgPwAAAAAAAOA/AAAAAAAA4D8AAAAAAADgPwAAAAAAAOA/AAAAAAAA4D8AAAAAAADgPwAAAAAAAOA/AAAAAAAA4D8CAAAAjAAAAAAAAAAAAAAAQoX0DP///wgAAAAAAAAAAAAAAAAAAAAAAAAAAAAAAAAAAAAAZAAAAAEAAABAAAAAAAAAAAAAAAAAAAAAAAAAAAAAAAAAAAAAAAAAAAAAAAAAAAAAAAAAAAAAAAAAAAAAAAAAAAAAAAAAAAAAAAAAAAAAAAAAAAAAAAAAAAAAAAAAAAAAFAAAADwAAAAAAAAAAAAAAAAAAAkUAAAAAQAAABQAAAAUAAAAFAAAAAEAAAAAAAAAZAAAAGQAAAAAAAAAZAAAAGQAAAAVAAAAYAAAAAAAAAAAAAAADwAAACADAAAAAAAAAAAAAAEAAACgMgAAVgcAAKr4//8BAAAAf39/AAEAAABkAAAAAAAAABQAAABAHwAAAAAAACYAAAAAAAAAwOD//wAAAAAmAAAAZAAAABYAAABMAAAAAAAAAAAAAAAEAAAAAAAAAAEAAABZWVkKAAAAACgAAAAoAAAAZAAAAGQAAAAAAAAAzMzMAAAAAABQAAAAUAAAAGQAAABkAAAAAAAAABcAAAAUAAAAAAAAAAAAAAD/fwAA/38AAAAAAAAJAAAABAAAAAAAAAAeAAAAaAAAAAAAAAAAAAAAAAAAAAAAAAAAAAAAECcAABAnAAAAAAAAAAAAAAAAAAAAAAAAAAAAAAAAAAAAAAAAAAAAABQAAAAAAAAAwMD/AAAAAABkAAAAMgAAAAAAAABkAAAAAAAAAH9/fwAKAAAAIgAAABgAAAAAAAAAAAAAAAAAAAAAAAAAAAAAAAAAAAAkAAAAJAAAAAAAAAAHAAAAAAAAAAAAAAAAAAAAAAAAAAAAAAAAAAAAf39/ACUAAABYAAAAAAAAAAAAAAAAAAAAAAAAAAAAAAAAAAAAAAAAAAAAAAAAAAAAAAAAAAAAAAA/AAAAAAAAAKCGAQAAAAAAAAAAAAAAAAAMAAAAAQAAAAAAAAAAAAAAAAAAAB8AAABUAAAAAAAABQAAAAEAAAAAAAAAAAAAAAAAAAAAAAAAAAAAAAAAAAAAAAAAAAAAAAJ/f38AAAAAA8zMzADAwP8Af39/AAAAAAAAAAAAAAAAAAAAAAAAAAAAIQAAABgAAAAUAAAAwRoAAPoUAAD6NgAAtCUAABAAAAAmAAAACAAAAD2wAAAAAAAA"/>
               </a:ext>
             </a:extLst>
           </p:cNvSpPr>
@@ -7107,7 +6988,7 @@
           <p:cNvSpPr>
             <a:extLst>
               <a:ext uri="smNativeData">
-                <pr:smNativeData xmlns:pr="smNativeData" xmlns="smNativeData" val="SMDATA_15_EkJ5ZhMAAAAlAAAAZAAAAA0AAAAAkAAAAJAAAACQAAAAkAAAAAAAAAABAAAAAAAAAAEAAABQAAAAAAAAAAAA4D8AAAAAAADgPwAAAAAAAOA/AAAAAAAA4D8AAAAAAADgPwAAAAAAAOA/AAAAAAAA4D8AAAAAAADgPwAAAAAAAOA/AAAAAAAA4D8CAAAAjAAAAAEAAAAAAAAA8/PzAP///wgAAAAAAAAAAAAAAAAAAAAAAAAAAAAAAAAAAAAAeAAAAAEAAABAAAAAAAAAAAAAAABaAAAAAAAAAAAAAAAAAAAAAAAAAAAAAAAAAAAAAAAAAAAAAAAAAAAAAAAAAAAAAAAAAAAAAAAAAAAAAAAAAAAAAAAAAAAAAAAAAAAAFAAAADwAAAAAAAAAAAAAAAAAAAkUAAAAAQAAABQAAAAUAAAAFAAAAAEAAAAAAAAAZAAAAGQAAAAAAAAAZAAAAGQAAAAVAAAAYAAAAAAAAAAAAAAADwAAACADAAAAAAAAAAAAAAEAAACgMgAAVgcAAKr4//8BAAAAf39/AAEAAABkAAAAAAAAABQAAABAHwAAAAAAACYAAAAAAAAAwOD//wAAAAAmAAAAZAAAABYAAABMAAAAAAAAAAAAAAAEAAAAAAAAAAEAAABZWVkKAAAAACgAAAAoAAAAZAAAAGQAAAAAAAAAzMzMAAAAAABQAAAAUAAAAGQAAABkAAAAAAAAABcAAAAUAAAAAAAAAAAAAAD/fwAA/38AAAAAAAAJAAAABAAAAAAAAAAeAAAAaAAAAAAAAAAAAAAAAAAAAAAAAAAAAAAAECcAABAnAAAAAAAAAAAAAAAAAAAAAAAAAAAAAAAAAAAAAAAAAAAAABQAAAAAAAAAwMD/AAAAAABkAAAAMgAAAAAAAABkAAAAAAAAAH9/fwAKAAAAIgAAABgAAAAAAAAAAAAAAAAAAAAAAAAAAAAAAAAAAAAkAAAAJAAAAAAAAAAHAAAAAAAAAAAAAAAAAAAAAAAAAAAAAAAAAAAAf39/ACUAAABYAAAAAAAAAAAAAAAAAAAAAAAAAAAAAAAAAAAAAAAAAAAAAAAAAAAAAAAAAAAAAAA/AAAAAAAAAKCGAQAAAAAAAAAAAAAAAAAMAAAAAQAAAAAAAAAAAAAAAAAAAB8AAABUAAAA8/PzAAAAAAEAAAAAAAAAAAAAAAAAAAAAAAAAAAAAAAAAAAAAAAAAAAAAAAJ/f38AAAAAA8zMzADAwP8Af39/AAAAAAAAAAAAAAAAAAAAAAAAAAAAIQAAABgAAAAUAAAAIBwAAAAAAABAOAAAMCoAABAAAAAmAAAACAAAAP//////////"/>
+                <pr:smNativeData xmlns:pr="smNativeData" xmlns="smNativeData" val="SMDATA_15_LkR5ZhMAAAAlAAAAZAAAAA0AAAAAkAAAAJAAAACQAAAAkAAAAAAAAAABAAAAAAAAAAEAAABQAAAAAAAAAAAA4D8AAAAAAADgPwAAAAAAAOA/AAAAAAAA4D8AAAAAAADgPwAAAAAAAOA/AAAAAAAA4D8AAAAAAADgPwAAAAAAAOA/AAAAAAAA4D8CAAAAjAAAAAEAAAAAAAAA8/PzAP///wgAAAAAAAAAAAAAAAAAAAAAAAAAAAAAAAAAAAAAeAAAAAEAAABAAAAAAAAAAAAAAABaAAAAAAAAAAAAAAAAAAAAAAAAAAAAAAAAAAAAAAAAAAAAAAAAAAAAAAAAAAAAAAAAAAAAAAAAAAAAAAAAAAAAAAAAAAAAAAAAAAAAFAAAADwAAAAAAAAAAAAAAAAAAAkUAAAAAQAAABQAAAAUAAAAFAAAAAEAAAAAAAAAZAAAAGQAAAAAAAAAZAAAAGQAAAAVAAAAYAAAAAAAAAAAAAAADwAAACADAAAAAAAAAAAAAAEAAACgMgAAVgcAAKr4//8BAAAAf39/AAEAAABkAAAAAAAAABQAAABAHwAAAAAAACYAAAAAAAAAwOD//wAAAAAmAAAAZAAAABYAAABMAAAAAAAAAAAAAAAEAAAAAAAAAAEAAABZWVkKAAAAACgAAAAoAAAAZAAAAGQAAAAAAAAAzMzMAAAAAABQAAAAUAAAAGQAAABkAAAAAAAAABcAAAAUAAAAAAAAAAAAAAD/fwAA/38AAAAAAAAJAAAABAAAAAAAAAAeAAAAaAAAAAAAAAAAAAAAAAAAAAAAAAAAAAAAECcAABAnAAAAAAAAAAAAAAAAAAAAAAAAAAAAAAAAAAAAAAAAAAAAABQAAAAAAAAAwMD/AAAAAABkAAAAMgAAAAAAAABkAAAAAAAAAH9/fwAKAAAAIgAAABgAAAAAAAAAAAAAAAAAAAAAAAAAAAAAAAAAAAAkAAAAJAAAAAAAAAAHAAAAAAAAAAAAAAAAAAAAAAAAAAAAAAAAAAAAf39/ACUAAABYAAAAAAAAAAAAAAAAAAAAAAAAAAAAAAAAAAAAAAAAAAAAAAAAAAAAAAAAAAAAAAA/AAAAAAAAAKCGAQAAAAAAAAAAAAAAAAAMAAAAAQAAAAAAAAAAAAAAAAAAAB8AAABUAAAA8/PzAAAAAAEAAAAAAAAAAAAAAAAAAAAAAAAAAAAAAAAAAAAAAAAAAAAAAAJ/f38AAAAAA8zMzADAwP8Af39/AAAAAAAAAAAAAAAAAAAAAAAAAAAAIQAAABgAAAAUAAAAIBwAAAAAAABAOAAAMCoAABAAAAAmAAAACAAAAP//////////"/>
               </a:ext>
             </a:extLst>
           </p:cNvSpPr>
@@ -7152,7 +7033,7 @@
             <a:spLocks noGrp="1" noChangeArrowheads="1"/>
             <a:extLst>
               <a:ext uri="smNativeData">
-                <pr:smNativeData xmlns:pr="smNativeData" xmlns="smNativeData" val="SMDATA_15_EkJ5ZhMAAAAlAAAAZAAAAA0AAAAAkAAAAJAAAACQAAAAkAAAAAAAAAACAAAAAAAAAAEAAABQAAAAAAAAAAAA4D8AAAAAAADgPwAAAAAAAOA/AAAAAAAA4D8AAAAAAADgPwAAAAAAAOA/AAAAAAAA4D8AAAAAAADgPwAAAAAAAOA/AAAAAAAA4D8CAAAAjAAAAAAAAAAAAAAAQoX0DP///wgAAAAAAAAAAAAAAAAAAAAAAAAAAAAAAAAAAAAAZAAAAAEAAABAAAAAAAAAAAAAAAAAAAAAAAAAAAAAAAAAAAAAAAAAAAAAAAAAAAAAAAAAAAAAAAAAAAAAAAAAAAAAAAAAAAAAAAAAAAAAAAAAAAAAAAAAAAAAAAAAAAAAFAAAADwAAAAAAAAAAAAAAAAAAAkUAAAAAQAAABQAAAAUAAAAFAAAAAEAAAAAAAAAZAAAAGQAAAAAAAAAZAAAAGQAAAAVAAAAYAAAAAAAAAAAAAAADwAAACADAAAAAAAAAAAAAAEAAACgMgAAVgcAAKr4//8BAAAAf39/AAEAAABkAAAAAAAAABQAAABAHwAAAAAAACYAAAAAAAAAwOD//wAAAAAmAAAAZAAAABYAAABMAAAAAAAAAAAAAAAEAAAAAAAAAAEAAABZWVkKAAAAACgAAAAoAAAAZAAAAGQAAAAAAAAAzMzMAAAAAABQAAAAUAAAAGQAAABkAAAAAAAAABcAAAAUAAAAAAAAAAAAAAD/fwAA/38AAAAAAAAJAAAABAAAAAAAAAAeAAAAaAAAAAAAAAAAAAAAAAAAAAAAAAAAAAAAECcAABAnAAAAAAAAAAAAAAAAAAAAAAAAAAAAAAAAAAAAAAAAAAAAABQAAAAAAAAAwMD/AAAAAABkAAAAMgAAAAAAAABkAAAAAAAAAH9/fwAKAAAAIgAAABgAAAAAAAAAAAAAAAAAAAAAAAAAAAAAAAAAAAAkAAAAJAAAAAAAAAAHAAAAAAAAAAAAAAAAAAAAAAAAAAAAAAAAAAAAf39/ACUAAABYAAAAAAAAAAAAAAAAAAAAAAAAAAAAAAAAAAAAAAAAAAAAAAAAAAAAAAAAAAAAAAA/AAAAAAAAAKCGAQAAAAAAAAAAAAAAAAAMAAAAAQAAAAAAAAAAAAAAAAAAAB8AAABUAAAAAAAABQAAAAEAAAAAAAAAAAAAAAAAAAAAAAAAAAAAAAAAAAAAAAAAAAAAAAJ/f38AAAAAA8zMzADAwP8Af39/AAAAAAAAAAAAAAAAAAAAAAAAAAAAIQAAABgAAAAUAAAAvwMAAAQKAACiHAAALBYAABAAAAAmAAAACAAAAL2wAAAAAAAA"/>
+                <pr:smNativeData xmlns:pr="smNativeData" xmlns="smNativeData" val="SMDATA_15_LkR5ZhMAAAAlAAAAZAAAAA0AAAAAkAAAAJAAAACQAAAAkAAAAAAAAAACAAAAAAAAAAEAAABQAAAAAAAAAAAA4D8AAAAAAADgPwAAAAAAAOA/AAAAAAAA4D8AAAAAAADgPwAAAAAAAOA/AAAAAAAA4D8AAAAAAADgPwAAAAAAAOA/AAAAAAAA4D8CAAAAjAAAAAAAAAAAAAAAQoX0DP///wgAAAAAAAAAAAAAAAAAAAAAAAAAAAAAAAAAAAAAZAAAAAEAAABAAAAAAAAAAAAAAAAAAAAAAAAAAAAAAAAAAAAAAAAAAAAAAAAAAAAAAAAAAAAAAAAAAAAAAAAAAAAAAAAAAAAAAAAAAAAAAAAAAAAAAAAAAAAAAAAAAAAAFAAAADwAAAAAAAAAAAAAAAAAAAkUAAAAAQAAABQAAAAUAAAAFAAAAAEAAAAAAAAAZAAAAGQAAAAAAAAAZAAAAGQAAAAVAAAAYAAAAAAAAAAAAAAADwAAACADAAAAAAAAAAAAAAEAAACgMgAAVgcAAKr4//8BAAAAf39/AAEAAABkAAAAAAAAABQAAABAHwAAAAAAACYAAAAAAAAAwOD//wAAAAAmAAAAZAAAABYAAABMAAAAAAAAAAAAAAAEAAAAAAAAAAEAAABZWVkKAAAAACgAAAAoAAAAZAAAAGQAAAAAAAAAzMzMAAAAAABQAAAAUAAAAGQAAABkAAAAAAAAABcAAAAUAAAAAAAAAAAAAAD/fwAA/38AAAAAAAAJAAAABAAAAAAAAAAeAAAAaAAAAAAAAAAAAAAAAAAAAAAAAAAAAAAAECcAABAnAAAAAAAAAAAAAAAAAAAAAAAAAAAAAAAAAAAAAAAAAAAAABQAAAAAAAAAwMD/AAAAAABkAAAAMgAAAAAAAABkAAAAAAAAAH9/fwAKAAAAIgAAABgAAAAAAAAAAAAAAAAAAAAAAAAAAAAAAAAAAAAkAAAAJAAAAAAAAAAHAAAAAAAAAAAAAAAAAAAAAAAAAAAAAAAAAAAAf39/ACUAAABYAAAAAAAAAAAAAAAAAAAAAAAAAAAAAAAAAAAAAAAAAAAAAAAAAAAAAAAAAAAAAAA/AAAAAAAAAKCGAQAAAAAAAAAAAAAAAAAMAAAAAQAAAAAAAAAAAAAAAAAAAB8AAABUAAAAAAAABQAAAAEAAAAAAAAAAAAAAAAAAAAAAAAAAAAAAAAAAAAAAAAAAAAAAAJ/f38AAAAAA8zMzADAwP8Af39/AAAAAAAAAAAAAAAAAAAAAAAAAAAAIQAAABgAAAAUAAAAvwMAAAQKAACiHAAALBYAABAAAAAmAAAACAAAAL2wAAAAAAAA"/>
               </a:ext>
             </a:extLst>
           </p:cNvSpPr>
@@ -7276,7 +7157,7 @@
             <a:spLocks noGrp="1" noChangeArrowheads="1"/>
             <a:extLst>
               <a:ext uri="smNativeData">
-                <pr:smNativeData xmlns:pr="smNativeData" xmlns="smNativeData" val="SMDATA_15_EkJ5ZhMAAAAlAAAAZAAAAA0AAAAAkAAAAJAAAACQAAAAkAAAAAAAAAAAAAAAAAAAAAEAAABQAAAAAAAAAAAA4D8AAAAAAADgPwAAAAAAAOA/AAAAAAAA4D8AAAAAAADgPwAAAAAAAOA/AAAAAAAA4D8AAAAAAADgPwAAAAAAAOA/AAAAAAAA4D8CAAAAjAAAAAAAAAAAAAAAQoX0DP///wgAAAAAAAAAAAAAAAAAAAAAAAAAAAAAAAAAAAAAZAAAAAEAAABAAAAAAAAAAAAAAAAAAAAAAAAAAAAAAAAAAAAAAAAAAAAAAAAAAAAAAAAAAAAAAAAAAAAAAAAAAAAAAAAAAAAAAAAAAAAAAAAAAAAAAAAAAAAAAAAAAAAAFAAAADwAAAAAAAAAAAAAAAAAAAkUAAAAAQAAABQAAAAUAAAAFAAAAAEAAAAAAAAAZAAAAGQAAAAAAAAAZAAAAGQAAAAVAAAAYAAAAAAAAAAAAAAADwAAACADAAAAAAAAAAAAAAEAAACgMgAAVgcAAKr4//8BAAAAf39/AAEAAABkAAAAAAAAABQAAABAHwAAAAAAACYAAAAAAAAAwOD//wAAAAAmAAAAZAAAABYAAABMAAAAAAAAAAAAAAAEAAAAAAAAAAEAAABZWVkKAAAAACgAAAAoAAAAZAAAAGQAAAAAAAAAzMzMAAAAAABQAAAAUAAAAGQAAABkAAAAAAAAABcAAAAUAAAAAAAAAAAAAAD/fwAA/38AAAAAAAAJAAAABAAAAAAAAAAeAAAAaAAAAAAAAAAAAAAAAAAAAAAAAAAAAAAAECcAABAnAAAAAAAAAAAAAAAAAAAAAAAAAAAAAAAAAAAAAAAAAAAAABQAAAAAAAAAwMD/AAAAAABkAAAAMgAAAAAAAABkAAAAAAAAAH9/fwAKAAAAIgAAABgAAAAAAAAAAAAAAAAAAAAAAAAAAAAAAAAAAAAkAAAAJAAAAAAAAAAHAAAAAAAAAAAAAAAAAAAAAAAAAAAAAAAAAAAAf39/ACUAAABYAAAAAAAAAAAAAAAAAAAAAAAAAAAAAAAAAAAAAAAAAAAAAAAAAAAAAAAAAAAAAAA/AAAAAAAAAKCGAQAAAAAAAAAAAAAAAAAMAAAAAQAAAAAAAAAAAAAAAAAAAB8AAABUAAAAAAAABQAAAAEAAAAAAAAAAAAAAAAAAAAAAAAAAAAAAAAAAAAAAAAAAAAAAAJ/f38AAAAAA8zMzADAwP8Af39/AAAAAAAAAAAAAAAAAAAAAAAAAAAAIQAAABgAAAAUAAAAvwMAAOsXAACiHAAADSIAABAAAAAmAAAACAAAAD2wAAAAAAAA"/>
+                <pr:smNativeData xmlns:pr="smNativeData" xmlns="smNativeData" val="SMDATA_15_LkR5ZhMAAAAlAAAAZAAAAA0AAAAAkAAAAJAAAACQAAAAkAAAAAAAAAAAAAAAAAAAAAEAAABQAAAAAAAAAAAA4D8AAAAAAADgPwAAAAAAAOA/AAAAAAAA4D8AAAAAAADgPwAAAAAAAOA/AAAAAAAA4D8AAAAAAADgPwAAAAAAAOA/AAAAAAAA4D8CAAAAjAAAAAAAAAAAAAAAQoX0DP///wgAAAAAAAAAAAAAAAAAAAAAAAAAAAAAAAAAAAAAZAAAAAEAAABAAAAAAAAAAAAAAAAAAAAAAAAAAAAAAAAAAAAAAAAAAAAAAAAAAAAAAAAAAAAAAAAAAAAAAAAAAAAAAAAAAAAAAAAAAAAAAAAAAAAAAAAAAAAAAAAAAAAAFAAAADwAAAAAAAAAAAAAAAAAAAkUAAAAAQAAABQAAAAUAAAAFAAAAAEAAAAAAAAAZAAAAGQAAAAAAAAAZAAAAGQAAAAVAAAAYAAAAAAAAAAAAAAADwAAACADAAAAAAAAAAAAAAEAAACgMgAAVgcAAKr4//8BAAAAf39/AAEAAABkAAAAAAAAABQAAABAHwAAAAAAACYAAAAAAAAAwOD//wAAAAAmAAAAZAAAABYAAABMAAAAAAAAAAAAAAAEAAAAAAAAAAEAAABZWVkKAAAAACgAAAAoAAAAZAAAAGQAAAAAAAAAzMzMAAAAAABQAAAAUAAAAGQAAABkAAAAAAAAABcAAAAUAAAAAAAAAAAAAAD/fwAA/38AAAAAAAAJAAAABAAAAAAAAAAeAAAAaAAAAAAAAAAAAAAAAAAAAAAAAAAAAAAAECcAABAnAAAAAAAAAAAAAAAAAAAAAAAAAAAAAAAAAAAAAAAAAAAAABQAAAAAAAAAwMD/AAAAAABkAAAAMgAAAAAAAABkAAAAAAAAAH9/fwAKAAAAIgAAABgAAAAAAAAAAAAAAAAAAAAAAAAAAAAAAAAAAAAkAAAAJAAAAAAAAAAHAAAAAAAAAAAAAAAAAAAAAAAAAAAAAAAAAAAAf39/ACUAAABYAAAAAAAAAAAAAAAAAAAAAAAAAAAAAAAAAAAAAAAAAAAAAAAAAAAAAAAAAAAAAAA/AAAAAAAAAKCGAQAAAAAAAAAAAAAAAAAMAAAAAQAAAAAAAAAAAAAAAAAAAB8AAABUAAAAAAAABQAAAAEAAAAAAAAAAAAAAAAAAAAAAAAAAAAAAAAAAAAAAAAAAAAAAAJ/f38AAAAAA8zMzADAwP8Af39/AAAAAAAAAAAAAAAAAAAAAAAAAAAAIQAAABgAAAAUAAAAvwMAAOsXAACiHAAADSIAABAAAAAmAAAACAAAAD2wAAAAAAAA"/>
               </a:ext>
             </a:extLst>
           </p:cNvSpPr>
@@ -7427,7 +7308,7 @@
             <a:spLocks noGrp="1" noChangeArrowheads="1"/>
             <a:extLst>
               <a:ext uri="smNativeData">
-                <pr:smNativeData xmlns:pr="smNativeData" xmlns="smNativeData" val="SMDATA_15_EkJ5ZhMAAAAlAAAAZAAAAA0AAAAAkAAAAJAAAACQAAAAkAAAAAAAAAABAAAAAAAAAAEAAABQAAAAAAAAAAAA4D8AAAAAAADgPwAAAAAAAOA/AAAAAAAA4D8AAAAAAADgPwAAAAAAAOA/AAAAAAAA4D8AAAAAAADgPwAAAAAAAOA/AAAAAAAA4D8CAAAAjAAAAAAAAAAAAAAAQoX0DP///wgAAAAAAAAAAAAAAAAAAAAAAAAAAAAAAAAAAAAAZAAAAAEAAABAAAAAAAAAAAAAAAAAAAAAAAAAAAAAAAAAAAAAAAAAAAAAAAAAAAAAAAAAAAAAAAAAAAAAAAAAAAAAAAAAAAAAAAAAAAAAAAAAAAAAAAAAAAAAAAAAAAAAFAAAADwAAAAAAAAAAAAAAAAAAAkUAAAAAQAAABQAAAAUAAAAFAAAAAEAAAAAAAAAZAAAAGQAAAAAAAAAZAAAAGQAAAAVAAAAYAAAAAAAAAAAAAAADwAAACADAAAAAAAAAAAAAAEAAACgMgAAVgcAAKr4//8BAAAAf39/AAEAAABkAAAAAAAAABQAAABAHwAAAAAAACYAAAAAAAAAwOD//wAAAAAmAAAAZAAAABYAAABMAAAAAAAAAAAAAAAEAAAAAAAAAAEAAABZWVkKAAAAACgAAAAoAAAAZAAAAGQAAAAAAAAAzMzMAAAAAABQAAAAUAAAAGQAAABkAAAAAAAAABcAAAAUAAAAAAAAAAAAAAD/fwAA/38AAAAAAAAJAAAABAAAAAAAAMAeAAAAaAAAAAAAAAAAAAAAAAAAAAAAAAAAAAAAECcAABAnAAAAAAAAAAAAAAAAAAAAAAAAAAAAAAAAAAAAAAAAAAAAABQAAAAAAAAAwMD/AAAAAABkAAAAMgAAAAAAAABkAAAAAAAAAH9/fwAKAAAAIgAAABgAAAAAAAAAAAAAAAAAAAAAAAAAAAAAAAAAAAAkAAAAJAAAAAAAAAAHAAAAAAAAAAAAAAAAAAAAAAAAAAAAAAAAAAAAf39/ACUAAABYAAAAAAAAAAAAAAAAAAAAAAAAAAAAAAAAAAAAAAAAAAAAAAAAAAAAAAAAAAAAAAA/AAAAAAAAAKCGAQAAAAAAAAAAAAAAAAAMAAAAAQAAAAAAAAAAAAAAAAAAAB8AAABUAAAAAAAABQAAAAEAAAAAAAAAAAAAAAAAAAAAAAAAAAAAAAAAAAAAAAAAAAAAAAJ/f38AAAAAA8zMzADAwP8Af39/AAAAAAAAAAAAAAAAAAAAAAAAAAAAIQAAABgAAAAUAAAAYx4AAPAFAAD9NQAAPyQAABAAAAAmAAAACAAAAL2wAAAAAAAA"/>
+                <pr:smNativeData xmlns:pr="smNativeData" xmlns="smNativeData" val="SMDATA_15_LkR5ZhMAAAAlAAAAZAAAAA0AAAAAkAAAAJAAAACQAAAAkAAAAAAAAAABAAAAAAAAAAEAAABQAAAAAAAAAAAA4D8AAAAAAADgPwAAAAAAAOA/AAAAAAAA4D8AAAAAAADgPwAAAAAAAOA/AAAAAAAA4D8AAAAAAADgPwAAAAAAAOA/AAAAAAAA4D8CAAAAjAAAAAAAAAAAAAAAQoX0DP///wgAAAAAAAAAAAAAAAAAAAAAAAAAAAAAAAAAAAAAZAAAAAEAAABAAAAAAAAAAAAAAAAAAAAAAAAAAAAAAAAAAAAAAAAAAAAAAAAAAAAAAAAAAAAAAAAAAAAAAAAAAAAAAAAAAAAAAAAAAAAAAAAAAAAAAAAAAAAAAAAAAAAAFAAAADwAAAAAAAAAAAAAAAAAAAkUAAAAAQAAABQAAAAUAAAAFAAAAAEAAAAAAAAAZAAAAGQAAAAAAAAAZAAAAGQAAAAVAAAAYAAAAAAAAAAAAAAADwAAACADAAAAAAAAAAAAAAEAAACgMgAAVgcAAKr4//8BAAAAf39/AAEAAABkAAAAAAAAABQAAABAHwAAAAAAACYAAAAAAAAAwOD//wAAAAAmAAAAZAAAABYAAABMAAAAAAAAAAAAAAAEAAAAAAAAAAEAAABZWVkKAAAAACgAAAAoAAAAZAAAAGQAAAAAAAAAzMzMAAAAAABQAAAAUAAAAGQAAABkAAAAAAAAABcAAAAUAAAAAAAAAAAAAAD/fwAA/38AAAAAAAAJAAAABAAAAAAAAMAeAAAAaAAAAAAAAAAAAAAAAAAAAAAAAAAAAAAAECcAABAnAAAAAAAAAAAAAAAAAAAAAAAAAAAAAAAAAAAAAAAAAAAAABQAAAAAAAAAwMD/AAAAAABkAAAAMgAAAAAAAABkAAAAAAAAAH9/fwAKAAAAIgAAABgAAAAAAAAAAAAAAAAAAAAAAAAAAAAAAAAAAAAkAAAAJAAAAAAAAAAHAAAAAAAAAAAAAAAAAAAAAAAAAAAAAAAAAAAAf39/ACUAAABYAAAAAAAAAAAAAAAAAAAAAAAAAAAAAAAAAAAAAAAAAAAAAAAAAAAAAAAAAAAAAAA/AAAAAAAAAKCGAQAAAAAAAAAAAAAAAAAMAAAAAQAAAAAAAAAAAAAAAAAAAB8AAABUAAAAAAAABQAAAAEAAAAAAAAAAAAAAAAAAAAAAAAAAAAAAAAAAAAAAAAAAAAAAAJ/f38AAAAAA8zMzADAwP8Af39/AAAAAAAAAAAAAAAAAAAAAAAAAAAAIQAAABgAAAAUAAAAYx4AAPAFAAD9NQAAPyQAABAAAAAmAAAACAAAAL2wAAAAAAAA"/>
               </a:ext>
             </a:extLst>
           </p:cNvSpPr>
@@ -7551,7 +7432,7 @@
             <a:spLocks noGrp="1" noChangeArrowheads="1"/>
             <a:extLst>
               <a:ext uri="smNativeData">
-                <pr:smNativeData xmlns:pr="smNativeData" xmlns="smNativeData" val="SMDATA_15_EkJ5ZhMAAAAlAAAAZAAAAA0AAAAAkAAAAJAAAACQAAAAkAAAAAAAAAABAAAAAAAAAAEAAABQAAAAAAAAAAAA4D8AAAAAAADgPwAAAAAAAOA/AAAAAAAA4D8AAAAAAADgPwAAAAAAAOA/AAAAAAAA4D8AAAAAAADgPwAAAAAAAOA/AAAAAAAA4D8CAAAAjAAAAAAAAAAAAAAAQoX0DP///wgAAAAAAAAAAAAAAAAAAAAAAAAAAAAAAAAAAAAAZAAAAAEAAABAAAAAAAAAAAAAAAAAAAAAAAAAAAAAAAAAAAAAAAAAAAAAAAAAAAAAAAAAAAAAAAAAAAAAAAAAAAAAAAAAAAAAAAAAAAAAAAAAAAAAAAAAAAAAAAAAAAAAFAAAADwAAAAAAAAAAAAAAAAAAAkUAAAAAQAAABQAAAAUAAAAFAAAAAEAAAAAAAAAZAAAAGQAAAAAAAAAZAAAAGQAAAAVAAAAYAAAAAAAAAAAAAAADwAAACADAAAAAAAAAAAAAAEAAACgMgAAVgcAAKr4//8BAAAAf39/AAEAAABkAAAAAAAAABQAAABAHwAAAAAAACYAAAAAAAAAwOD//wAAAAAmAAAAZAAAABYAAABMAAAAAAAAAAAAAAAEAAAAAAAAAAEAAABZWVkKAAAAACgAAAAoAAAAZAAAAGQAAAAAAAAAzMzMAAAAAABQAAAAUAAAAGQAAABkAAAAAAAAABcAAAAUAAAAAAAAAAAAAAD/fwAA/38AAAAAAAAJAAAABAAAAAAAAAAeAAAAaAAAAAAAAAAAAAAAAAAAAAAAAAAAAAAAECcAABAnAAAAAAAAAAAAAAAAAAAAAAAAAAAAAAAAAAAAAAAAAAAAABQAAAAAAAAAwMD/AAAAAABkAAAAMgAAAAAAAABkAAAAAAAAAH9/fwAKAAAAIgAAABgAAAAAAAAAAAAAAAAAAAAAAAAAAAAAAAAAAAAkAAAAJAAAAAAAAAAHAAAAAAAAAAAAAAAAAAAAAAAAAAAAAAAAAAAAf39/ACUAAABYAAAAAAAAAAAAAAAAAAAAAAAAAAAAAAAAAAAAAAAAAAAAAAAAAAAAAAAAAAAAAAA/AAAAAAAAAKCGAQAAAAAAAAAAAAAAAAAMAAAAAQAAAAAAAAAAAAAAAAAAAB8AAABUAAAAAAAABQAAAAEAAAAAAAAAAAAAAAAAAAAAAAAAAAAAAAAAAAAAAAAAAAAAAAJ/f38AAAAAA8zMzADAwP8Af39/AAAAAAAAAAAAAAAAAAAAAAAAAAAAIQAAABgAAAAUAAAAHjQAAEAmAAB/NwAAeikAABAAAAAmAAAACAAAADywAAAAAAAA"/>
+                <pr:smNativeData xmlns:pr="smNativeData" xmlns="smNativeData" val="SMDATA_15_LkR5ZhMAAAAlAAAAZAAAAA0AAAAAkAAAAJAAAACQAAAAkAAAAAAAAAABAAAAAAAAAAEAAABQAAAAAAAAAAAA4D8AAAAAAADgPwAAAAAAAOA/AAAAAAAA4D8AAAAAAADgPwAAAAAAAOA/AAAAAAAA4D8AAAAAAADgPwAAAAAAAOA/AAAAAAAA4D8CAAAAjAAAAAAAAAAAAAAAQoX0DP///wgAAAAAAAAAAAAAAAAAAAAAAAAAAAAAAAAAAAAAZAAAAAEAAABAAAAAAAAAAAAAAAAAAAAAAAAAAAAAAAAAAAAAAAAAAAAAAAAAAAAAAAAAAAAAAAAAAAAAAAAAAAAAAAAAAAAAAAAAAAAAAAAAAAAAAAAAAAAAAAAAAAAAFAAAADwAAAAAAAAAAAAAAAAAAAkUAAAAAQAAABQAAAAUAAAAFAAAAAEAAAAAAAAAZAAAAGQAAAAAAAAAZAAAAGQAAAAVAAAAYAAAAAAAAAAAAAAADwAAACADAAAAAAAAAAAAAAEAAACgMgAAVgcAAKr4//8BAAAAf39/AAEAAABkAAAAAAAAABQAAABAHwAAAAAAACYAAAAAAAAAwOD//wAAAAAmAAAAZAAAABYAAABMAAAAAAAAAAAAAAAEAAAAAAAAAAEAAABZWVkKAAAAACgAAAAoAAAAZAAAAGQAAAAAAAAAzMzMAAAAAABQAAAAUAAAAGQAAABkAAAAAAAAABcAAAAUAAAAAAAAAAAAAAD/fwAA/38AAAAAAAAJAAAABAAAAAAAAAAeAAAAaAAAAAAAAAAAAAAAAAAAAAAAAAAAAAAAECcAABAnAAAAAAAAAAAAAAAAAAAAAAAAAAAAAAAAAAAAAAAAAAAAABQAAAAAAAAAwMD/AAAAAABkAAAAMgAAAAAAAABkAAAAAAAAAH9/fwAKAAAAIgAAABgAAAAAAAAAAAAAAAAAAAAAAAAAAAAAAAAAAAAkAAAAJAAAAAAAAAAHAAAAAAAAAAAAAAAAAAAAAAAAAAAAAAAAAAAAf39/ACUAAABYAAAAAAAAAAAAAAAAAAAAAAAAAAAAAAAAAAAAAAAAAAAAAAAAAAAAAAAAAAAAAAA/AAAAAAAAAKCGAQAAAAAAAAAAAAAAAAAMAAAAAQAAAAAAAAAAAAAAAAAAAB8AAABUAAAAAAAABQAAAAEAAAAAAAAAAAAAAAAAAAAAAAAAAAAAAAAAAAAAAAAAAAAAAAJ/f38AAAAAA8zMzADAwP8Af39/AAAAAAAAAAAAAAAAAAAAAAAAAAAAIQAAABgAAAAUAAAAHjQAAEAmAAB/NwAAeikAABAAAAAmAAAACAAAADywAAAAAAAA"/>
               </a:ext>
             </a:extLst>
           </p:cNvSpPr>
@@ -7605,10 +7486,11 @@
               </a:spcAft>
               <a:buNone/>
             </a:pPr>
-            <a:fld id="{3FC241BE-F0D2-97B7-9C7A-06E20F346A53}" type="slidenum">
+            <a:fld id="{3FDAA099-D7D2-8F56-9C62-2103EE2C6A74}" type="slidenum">
               <a:rPr lang="ru-ru" cap="none"/>
               <a:t>‹#›</a:t>
             </a:fld>
+            <a:endParaRPr lang="ru-ru" cap="none"/>
           </a:p>
         </p:txBody>
       </p:sp>
@@ -7645,7 +7527,7 @@
             <a:spLocks noGrp="1" noChangeArrowheads="1"/>
             <a:extLst>
               <a:ext uri="smNativeData">
-                <pr:smNativeData xmlns:pr="smNativeData" xmlns="smNativeData" val="SMDATA_15_EkJ5ZhMAAAAlAAAAZAAAAA0AAAAAkAAAAJAAAACQAAAAkAAAAAAAAAABAAAAAAAAAAEAAABQAAAAAAAAAAAA4D8AAAAAAADgPwAAAAAAAOA/AAAAAAAA4D8AAAAAAADgPwAAAAAAAOA/AAAAAAAA4D8AAAAAAADgPwAAAAAAAOA/AAAAAAAA4D8CAAAAjAAAAAAAAAAAAAAAQoX0DP///wgAAAAAAAAAAAAAAAAAAAAAAAAAAAAAAAAAAAAAZAAAAAEAAABAAAAAAAAAAAAAAAAAAAAAAAAAAAAAAAAAAAAAAAAAAAAAAAAAAAAAAAAAAAAAAAAAAAAAAAAAAAAAAAAAAAAAAAAAAAAAAAAAAAAAAAAAAAAAAAAAAAAAFAAAADwAAAAAAAAAAAAAAAAAAAkUAAAAAQAAABQAAAAUAAAAFAAAAAEAAAAAAAAAZAAAAGQAAAAAAAAAZAAAAGQAAAAVAAAAYAAAAAAAAAAAAAAADwAAACADAAAAAAAAAAAAAAEAAACgMgAAVgcAAKr4//8BAAAAf39/AAEAAABkAAAAAAAAABQAAABAHwAAAAAAACYAAAAAAAAAwOD//wAAAAAmAAAAZAAAABYAAABMAAAAAAAAAAAAAAAEAAAAAAAAAAEAAABZWVkKAAAAACgAAAAoAAAAZAAAAGQAAAAAAAAAzMzMAAAAAABQAAAAUAAAAGQAAABkAAAAAAAAABcAAAAUAAAAAAAAAAAAAAD/fwAA/38AAAAAAAAJAAAABAAAAAAAAAAeAAAAaAAAAAAAAAAAAAAAAAAAAAAAAAAAAAAAECcAABAnAAAAAAAAAAAAAAAAAAAAAAAAAAAAAAAAAAAAAAAAAAAAABQAAAAAAAAAwMD/AAAAAABkAAAAMgAAAAAAAABkAAAAAAAAAH9/fwAKAAAAIgAAABgAAAAAAAAAAAAAAAAAAAAAAAAAAAAAAAAAAAAkAAAAJAAAAAAAAAAHAAAAAAAAAAAAAAAAAAAAAAAAAAAAAAAAAAAAf39/ACUAAABYAAAAAAAAAAAAAAAAAAAAAAAAAAAAAAAAAAAAAAAAAAAAAAAAAAAAAAAAAAAAAAA/AAAAAAAAAKCGAQAAAAAAAAAAAAAAAAAMAAAAAQAAAAAAAAAAAAAAAAAAAB8AAABUAAAAAAAABQAAAAEAAAAAAAAAAAAAAAAAAAAAAAAAAAAAAAAAAAAAAAAAAAAAAAJ/f38AAAAAA8zMzADAwP8Af39/AAAAAAAAAAAAAAAAAAAAAAAAAAAAIQAAABgAAAAUAAAAHjQAAEAmAAB/NwAAeikAABAAAAAmAAAACAAAADywAAAAAAAA"/>
+                <pr:smNativeData xmlns:pr="smNativeData" xmlns="smNativeData" val="SMDATA_15_LkR5ZhMAAAAlAAAAZAAAAA0AAAAAkAAAAJAAAACQAAAAkAAAAAAAAAABAAAAAAAAAAEAAABQAAAAAAAAAAAA4D8AAAAAAADgPwAAAAAAAOA/AAAAAAAA4D8AAAAAAADgPwAAAAAAAOA/AAAAAAAA4D8AAAAAAADgPwAAAAAAAOA/AAAAAAAA4D8CAAAAjAAAAAAAAAAAAAAAQoX0DP///wgAAAAAAAAAAAAAAAAAAAAAAAAAAAAAAAAAAAAAZAAAAAEAAABAAAAAAAAAAAAAAAAAAAAAAAAAAAAAAAAAAAAAAAAAAAAAAAAAAAAAAAAAAAAAAAAAAAAAAAAAAAAAAAAAAAAAAAAAAAAAAAAAAAAAAAAAAAAAAAAAAAAAFAAAADwAAAAAAAAAAAAAAAAAAAkUAAAAAQAAABQAAAAUAAAAFAAAAAEAAAAAAAAAZAAAAGQAAAAAAAAAZAAAAGQAAAAVAAAAYAAAAAAAAAAAAAAADwAAACADAAAAAAAAAAAAAAEAAACgMgAAVgcAAKr4//8BAAAAf39/AAEAAABkAAAAAAAAABQAAABAHwAAAAAAACYAAAAAAAAAwOD//wAAAAAmAAAAZAAAABYAAABMAAAAAAAAAAAAAAAEAAAAAAAAAAEAAABZWVkKAAAAACgAAAAoAAAAZAAAAGQAAAAAAAAAzMzMAAAAAABQAAAAUAAAAGQAAABkAAAAAAAAABcAAAAUAAAAAAAAAAAAAAD/fwAA/38AAAAAAAAJAAAABAAAAAAAAAAeAAAAaAAAAAAAAAAAAAAAAAAAAAAAAAAAAAAAECcAABAnAAAAAAAAAAAAAAAAAAAAAAAAAAAAAAAAAAAAAAAAAAAAABQAAAAAAAAAwMD/AAAAAABkAAAAMgAAAAAAAABkAAAAAAAAAH9/fwAKAAAAIgAAABgAAAAAAAAAAAAAAAAAAAAAAAAAAAAAAAAAAAAkAAAAJAAAAAAAAAAHAAAAAAAAAAAAAAAAAAAAAAAAAAAAAAAAAAAAf39/ACUAAABYAAAAAAAAAAAAAAAAAAAAAAAAAAAAAAAAAAAAAAAAAAAAAAAAAAAAAAAAAAAAAAA/AAAAAAAAAKCGAQAAAAAAAAAAAAAAAAAMAAAAAQAAAAAAAAAAAAAAAAAAAB8AAABUAAAAAAAABQAAAAEAAAAAAAAAAAAAAAAAAAAAAAAAAAAAAAAAAAAAAAAAAAAAAAJ/f38AAAAAA8zMzADAwP8Af39/AAAAAAAAAAAAAAAAAAAAAAAAAAAAIQAAABgAAAAUAAAAHjQAAEAmAAB/NwAAeikAABAAAAAmAAAACAAAADywAAAAAAAA"/>
               </a:ext>
             </a:extLst>
           </p:cNvSpPr>
@@ -7699,10 +7581,11 @@
               </a:spcAft>
               <a:buNone/>
             </a:pPr>
-            <a:fld id="{3FC2608D-C3D2-9796-9C7A-35C32E346A60}" type="slidenum">
+            <a:fld id="{3FDA96C6-88D2-8F60-9C62-7E35D82C6A2B}" type="slidenum">
               <a:rPr lang="ru-ru" cap="none"/>
               <a:t>‹#›</a:t>
             </a:fld>
+            <a:endParaRPr lang="ru-ru" cap="none"/>
           </a:p>
         </p:txBody>
       </p:sp>
@@ -7749,7 +7632,7 @@
             <a:spLocks noGrp="1" noChangeArrowheads="1"/>
             <a:extLst>
               <a:ext uri="smNativeData">
-                <pr:smNativeData xmlns:pr="smNativeData" xmlns="smNativeData" val="SMDATA_15_EkJ5ZhMAAAAlAAAAZAAAAA0AAAAAkAAAAJAAAACQAAAAkAAAAAAAAAAAAAAAAAAAAAEAAABQAAAAAAAAAAAA4D8AAAAAAADgPwAAAAAAAOA/AAAAAAAA4D8AAAAAAADgPwAAAAAAAOA/AAAAAAAA4D8AAAAAAADgPwAAAAAAAOA/AAAAAAAA4D8CAAAAjAAAAAAAAAAAAAAAQoX0DP///wgAAAAAAAAAAAAAAAAAAAAAAAAAAAAAAAAAAAAAZAAAAAEAAABAAAAAAAAAAAAAAAAAAAAAAAAAAAAAAAAAAAAAAAAAAAAAAAAAAAAAAAAAAAAAAAAAAAAAAAAAAAAAAAAAAAAAAAAAAAAAAAAAAAAAAAAAAAAAAAAAAAAAFAAAADwAAAAAAAAAAAAAAAAAAAkUAAAAAQAAABQAAAAUAAAAFAAAAAEAAAAAAAAAZAAAAGQAAAAAAAAAZAAAAGQAAAAVAAAAYAAAAAAAAAAAAAAADwAAACADAAAAAAAAAAAAAAEAAACgMgAAVgcAAKr4//8BAAAAf39/AAEAAABkAAAAAAAAABQAAABAHwAAAAAAACYAAAAAAAAAwOD//wAAAAAmAAAAZAAAABYAAABMAAAAAAAAAAAAAAAEAAAAAAAAAAEAAABZWVkKAAAAACgAAAAoAAAAZAAAAGQAAAAAAAAAzMzMAAAAAABQAAAAUAAAAGQAAABkAAAAAAAAABcAAAAUAAAAAAAAAAAAAAD/fwAA/38AAAAAAAAJAAAABAAAAGdlODkeAAAAaAAAAAAAAAAAAAAAAAAAAAAAAAAAAAAAECcAABAnAAAAAAAAAAAAAAAAAAAAAAAAAAAAAAAAAAAAAAAAAAAAABQAAAAAAAAAwMD/AAAAAABkAAAAMgAAAAAAAABkAAAAAAAAAH9/fwAKAAAAIgAAABgAAAAAAAAAAAAAAAAAAAAAAAAAAAAAAAAAAAAkAAAAJAAAAAAAAAAHAAAAAAAAAAAAAAAAAAAAAAAAAAAAAAAAAAAAf39/ACUAAABYAAAAAAAAAAAAAAAAAAAAAAAAAAAAAAAAAAAAAAAAAAAAAAAAAAAAAAAAAAAAAAA/AAAAAAAAAKCGAQAAAAAAAAAAAAAAAAAMAAAAAQAAAAAAAAAAAAAAAAAAAB8AAABUAAAAAAAABQAAAAEAAAAAAAAAAAAAAAAAAAAAAAAAAAAAAAAAAAAAAAAAAAAAAAJ/f38AAAAAA8zMzADAwP8Af39/AAAAAAAAAAAAAAAAAAAAAAAAAAAAIQAAABgAAAAUAAAAFAMAALYCAAB/NwAAvwoAABAAAAAmAAAACAAAAL2/AAD/HwAA"/>
+                <pr:smNativeData xmlns:pr="smNativeData" xmlns="smNativeData" val="SMDATA_15_LkR5ZhMAAAAlAAAAZAAAAA0AAAAAkAAAAJAAAACQAAAAkAAAAAAAAAAAAAAAAAAAAAEAAABQAAAAAAAAAAAA4D8AAAAAAADgPwAAAAAAAOA/AAAAAAAA4D8AAAAAAADgPwAAAAAAAOA/AAAAAAAA4D8AAAAAAADgPwAAAAAAAOA/AAAAAAAA4D8CAAAAjAAAAAAAAAAAAAAAQoX0DP///wgAAAAAAAAAAAAAAAAAAAAAAAAAAAAAAAAAAAAAZAAAAAEAAABAAAAAAAAAAAAAAAAAAAAAAAAAAAAAAAAAAAAAAAAAAAAAAAAAAAAAAAAAAAAAAAAAAAAAAAAAAAAAAAAAAAAAAAAAAAAAAAAAAAAAAAAAAAAAAAAAAAAAFAAAADwAAAAAAAAAAAAAAAAAAAkUAAAAAQAAABQAAAAUAAAAFAAAAAEAAAAAAAAAZAAAAGQAAAAAAAAAZAAAAGQAAAAVAAAAYAAAAAAAAAAAAAAADwAAACADAAAAAAAAAAAAAAEAAACgMgAAVgcAAKr4//8BAAAAf39/AAEAAABkAAAAAAAAABQAAABAHwAAAAAAACYAAAAAAAAAwOD//wAAAAAmAAAAZAAAABYAAABMAAAAAAAAAAAAAAAEAAAAAAAAAAEAAABZWVkKAAAAACgAAAAoAAAAZAAAAGQAAAAAAAAAzMzMAAAAAABQAAAAUAAAAGQAAABkAAAAAAAAABcAAAAUAAAAAAAAAAAAAAD/fwAA/38AAAAAAAAJAAAABAAAAGdlODkeAAAAaAAAAAAAAAAAAAAAAAAAAAAAAAAAAAAAECcAABAnAAAAAAAAAAAAAAAAAAAAAAAAAAAAAAAAAAAAAAAAAAAAABQAAAAAAAAAwMD/AAAAAABkAAAAMgAAAAAAAABkAAAAAAAAAH9/fwAKAAAAIgAAABgAAAAAAAAAAAAAAAAAAAAAAAAAAAAAAAAAAAAkAAAAJAAAAAAAAAAHAAAAAAAAAAAAAAAAAAAAAAAAAAAAAAAAAAAAf39/ACUAAABYAAAAAAAAAAAAAAAAAAAAAAAAAAAAAAAAAAAAAAAAAAAAAAAAAAAAAAAAAAAAAAA/AAAAAAAAAKCGAQAAAAAAAAAAAAAAAAAMAAAAAQAAAAAAAAAAAAAAAAAAAB8AAABUAAAAAAAABQAAAAEAAAAAAAAAAAAAAAAAAAAAAAAAAAAAAAAAAAAAAAAAAAAAAAJ/f38AAAAAA8zMzADAwP8Af39/AAAAAAAAAAAAAAAAAAAAAAAAAAAAIQAAABgAAAAUAAAAFAMAALYCAAB/NwAAvwoAABAAAAAmAAAACAAAAL2/AAD/HwAA"/>
               </a:ext>
             </a:extLst>
           </p:cNvSpPr>
@@ -7919,7 +7802,7 @@
             <a:spLocks noGrp="1" noChangeArrowheads="1"/>
             <a:extLst>
               <a:ext uri="smNativeData">
-                <pr:smNativeData xmlns:pr="smNativeData" xmlns="smNativeData" val="SMDATA_15_EkJ5ZhMAAAAlAAAAZAAAAA0AAAAAkAAAAJAAAACQAAAAkAAAAAAAAAAAAAAAAAAAAAEAAABQAAAAAAAAAAAA4D8AAAAAAADgPwAAAAAAAOA/AAAAAAAA4D8AAAAAAADgPwAAAAAAAOA/AAAAAAAA4D8AAAAAAADgPwAAAAAAAOA/AAAAAAAA4D8CAAAAjAAAAAAAAAAAAAAAQoX0DP///wgAAAAAAAAAAAAAAAAAAAAAAAAAAAAAAAAAAAAAZAAAAAEAAABAAAAAAAAAAAAAAAAAAAAAAAAAAAAAAAAAAAAAAAAAAAAAAAAAAAAAAAAAAAAAAAAAAAAAAAAAAAAAAAAAAAAAAAAAAAAAAAAAAAAAAAAAAAAAAAAAAAAAFAAAADwAAAAAAAAAAAAAAAAAAAkUAAAAAQAAABQAAAAUAAAAFAAAAAEAAAAAAAAAZAAAAGQAAAAAAAAAZAAAAGQAAAAVAAAAYAAAAAAAAAAAAAAADwAAACADAAAAAAAAAAAAAAEAAACgMgAAVgcAAKr4//8BAAAAf39/AAEAAABkAAAAAAAAABQAAABAHwAAAAAAACYAAAAAAAAAwOD//wAAAAAmAAAAZAAAABYAAABMAAAAAAAAAAAAAAAEAAAAAAAAAAEAAABZWVkKAAAAACgAAAAoAAAAZAAAAGQAAAAAAAAAzMzMAAAAAABQAAAAUAAAAGQAAABkAAAAAAAAABcAAAAUAAAAAAAAAAAAAAD/fwAA/38AAAAAAAAJAAAABAAAAGdlODkeAAAAaAAAAAAAAAAAAAAAAAAAAAAAAAAAAAAAECcAABAnAAAAAAAAAAAAAAAAAAAAAAAAAAAAAAAAAAAAAAAAAAAAABQAAAAAAAAAwMD/AAAAAABkAAAAMgAAAAAAAABkAAAAAAAAAH9/fwAKAAAAIgAAABgAAAAAAAAAAAAAAAAAAAAAAAAAAAAAAAAAAAAkAAAAJAAAAAAAAAAHAAAAAAAAAAAAAAAAAAAAAAAAAAAAAAAAAAAAf39/ACUAAABYAAAAAAAAAAAAAAAAAAAAAAAAAAAAAAAAAAAAAAAAAAAAAAAAAAAAAAAAAAAAAAA/AAAAAAAAAKCGAQAAAAAAAAAAAAAAAAAMAAAAAQAAAAAAAAAAAAAAAAAAAB8AAABUAAAAAAAABQAAAAEAAAAAAAAAAAAAAAAAAAAAAAAAAAAAAAAAAAAAAAAAAAAAAAJ/f38AAAAAA8zMzADAwP8Af39/AAAAAAAAAAAAAAAAAAAAAAAAAAAAIQAAABgAAAAUAAAAnAIAALMLAAAHNwAAuScAABAAAAAmAAAACAAAAL2/AAD/HwAA"/>
+                <pr:smNativeData xmlns:pr="smNativeData" xmlns="smNativeData" val="SMDATA_15_LkR5ZhMAAAAlAAAAZAAAAA0AAAAAkAAAAJAAAACQAAAAkAAAAAAAAAAAAAAAAAAAAAEAAABQAAAAAAAAAAAA4D8AAAAAAADgPwAAAAAAAOA/AAAAAAAA4D8AAAAAAADgPwAAAAAAAOA/AAAAAAAA4D8AAAAAAADgPwAAAAAAAOA/AAAAAAAA4D8CAAAAjAAAAAAAAAAAAAAAQoX0DP///wgAAAAAAAAAAAAAAAAAAAAAAAAAAAAAAAAAAAAAZAAAAAEAAABAAAAAAAAAAAAAAAAAAAAAAAAAAAAAAAAAAAAAAAAAAAAAAAAAAAAAAAAAAAAAAAAAAAAAAAAAAAAAAAAAAAAAAAAAAAAAAAAAAAAAAAAAAAAAAAAAAAAAFAAAADwAAAAAAAAAAAAAAAAAAAkUAAAAAQAAABQAAAAUAAAAFAAAAAEAAAAAAAAAZAAAAGQAAAAAAAAAZAAAAGQAAAAVAAAAYAAAAAAAAAAAAAAADwAAACADAAAAAAAAAAAAAAEAAACgMgAAVgcAAKr4//8BAAAAf39/AAEAAABkAAAAAAAAABQAAABAHwAAAAAAACYAAAAAAAAAwOD//wAAAAAmAAAAZAAAABYAAABMAAAAAAAAAAAAAAAEAAAAAAAAAAEAAABZWVkKAAAAACgAAAAoAAAAZAAAAGQAAAAAAAAAzMzMAAAAAABQAAAAUAAAAGQAAABkAAAAAAAAABcAAAAUAAAAAAAAAAAAAAD/fwAA/38AAAAAAAAJAAAABAAAAGdlODkeAAAAaAAAAAAAAAAAAAAAAAAAAAAAAAAAAAAAECcAABAnAAAAAAAAAAAAAAAAAAAAAAAAAAAAAAAAAAAAAAAAAAAAABQAAAAAAAAAwMD/AAAAAABkAAAAMgAAAAAAAABkAAAAAAAAAH9/fwAKAAAAIgAAABgAAAAAAAAAAAAAAAAAAAAAAAAAAAAAAAAAAAAkAAAAJAAAAAAAAAAHAAAAAAAAAAAAAAAAAAAAAAAAAAAAAAAAAAAAf39/ACUAAABYAAAAAAAAAAAAAAAAAAAAAAAAAAAAAAAAAAAAAAAAAAAAAAAAAAAAAAAAAAAAAAA/AAAAAAAAAKCGAQAAAAAAAAAAAAAAAAAMAAAAAQAAAAAAAAAAAAAAAAAAAB8AAABUAAAAAAAABQAAAAEAAAAAAAAAAAAAAAAAAAAAAAAAAAAAAAAAAAAAAAAAAAAAAAJ/f38AAAAAA8zMzADAwP8Af39/AAAAAAAAAAAAAAAAAAAAAAAAAAAAIQAAABgAAAAUAAAAnAIAALMLAAAHNwAAuScAABAAAAAmAAAACAAAAL2/AAD/HwAA"/>
               </a:ext>
             </a:extLst>
           </p:cNvSpPr>
@@ -8185,7 +8068,7 @@
             <a:spLocks noGrp="1" noChangeArrowheads="1"/>
             <a:extLst>
               <a:ext uri="smNativeData">
-                <pr:smNativeData xmlns:pr="smNativeData" xmlns="smNativeData" val="SMDATA_15_EkJ5ZhMAAAAlAAAAZAAAAA0AAAAAkAAAAJAAAACQAAAAkAAAAAAAAAABAAAAAAAAAAEAAABQAAAAAAAAAAAA4D8AAAAAAADgPwAAAAAAAOA/AAAAAAAA4D8AAAAAAADgPwAAAAAAAOA/AAAAAAAA4D8AAAAAAADgPwAAAAAAAOA/AAAAAAAA4D8CAAAAjAAAAAAAAAAAAAAAQoX0DP///wgAAAAAAAAAAAAAAAAAAAAAAAAAAAAAAAAAAAAAZAAAAAEAAABAAAAAAAAAAAAAAAAAAAAAAAAAAAAAAAAAAAAAAAAAAAAAAAAAAAAAAAAAAAAAAAAAAAAAAAAAAAAAAAAAAAAAAAAAAAAAAAAAAAAAAAAAAAAAAAAAAAAAFAAAADwAAAAAAAAAAAAAAAAAAAkUAAAAAQAAABQAAAAUAAAAFAAAAAEAAAAAAAAAZAAAAGQAAAAAAAAAZAAAAGQAAAAVAAAAYAAAAAAAAAAAAAAADwAAACADAAAAAAAAAAAAAAEAAACgMgAAVgcAAKr4//8BAAAAf39/AAEAAABkAAAAAAAAABQAAABAHwAAAAAAACYAAAAAAAAAwOD//wAAAAAmAAAAZAAAABYAAABMAAAAAAAAAAAAAAAEAAAAAAAAAAEAAABZWVkKAAAAACgAAAAoAAAAZAAAAGQAAAAAAAAAzMzMAAAAAABQAAAAUAAAAGQAAABkAAAAAAAAABcAAAAUAAAAAAAAAAAAAAD/fwAA/38AAAAAAAAJAAAABAAAAG0AOwAeAAAAaAAAAAAAAAAAAAAAAAAAAAAAAAAAAAAAECcAABAnAAAAAAAAAAAAAAAAAAAAAAAAAAAAAAAAAAAAAAAAAAAAABQAAAAAAAAAwMD/AAAAAABkAAAAMgAAAAAAAABkAAAAAAAAAH9/fwAKAAAAIgAAABgAAAAAAAAAAAAAAAAAAAAAAAAAAAAAAAAAAAAkAAAAJAAAAAAAAAAHAAAAAAAAAAAAAAAAAAAAAAAAAAAAAAAAAAAAf39/ACUAAABYAAAAAAAAAAAAAAAAAAAAAAAAAAAAAAAAAAAAAAAAAAAAAAAAAAAAAAAAAAAAAAA/AAAAAAAAAKCGAQAAAAAAAAAAAAAAAAAMAAAAAQAAAAAAAAAAAAAAAAAAAB8AAABUAAAAAAAABQAAAAEAAAAAAAAAAAAAAAAAAAAAAAAAAAAAAAAAAAAAAAAAAAAAAAJ/f38AAAAAA8zMzADAwP8Af39/AAAAAAAAAAAAAAAAAAAAAAAAAAAAIQAAABgAAAAUAAAAHjQAAEAmAAB/NwAAeikAABAAAAAmAAAACAAAAL2/AAD/HwAA"/>
+                <pr:smNativeData xmlns:pr="smNativeData" xmlns="smNativeData" val="SMDATA_15_LkR5ZhMAAAAlAAAAZAAAAA0AAAAAkAAAAJAAAACQAAAAkAAAAAAAAAABAAAAAAAAAAEAAABQAAAAAAAAAAAA4D8AAAAAAADgPwAAAAAAAOA/AAAAAAAA4D8AAAAAAADgPwAAAAAAAOA/AAAAAAAA4D8AAAAAAADgPwAAAAAAAOA/AAAAAAAA4D8CAAAAjAAAAAAAAAAAAAAAQoX0DP///wgAAAAAAAAAAAAAAAAAAAAAAAAAAAAAAAAAAAAAZAAAAAEAAABAAAAAAAAAAAAAAAAAAAAAAAAAAAAAAAAAAAAAAAAAAAAAAAAAAAAAAAAAAAAAAAAAAAAAAAAAAAAAAAAAAAAAAAAAAAAAAAAAAAAAAAAAAAAAAAAAAAAAFAAAADwAAAAAAAAAAAAAAAAAAAkUAAAAAQAAABQAAAAUAAAAFAAAAAEAAAAAAAAAZAAAAGQAAAAAAAAAZAAAAGQAAAAVAAAAYAAAAAAAAAAAAAAADwAAACADAAAAAAAAAAAAAAEAAACgMgAAVgcAAKr4//8BAAAAf39/AAEAAABkAAAAAAAAABQAAABAHwAAAAAAACYAAAAAAAAAwOD//wAAAAAmAAAAZAAAABYAAABMAAAAAAAAAAAAAAAEAAAAAAAAAAEAAABZWVkKAAAAACgAAAAoAAAAZAAAAGQAAAAAAAAAzMzMAAAAAABQAAAAUAAAAGQAAABkAAAAAAAAABcAAAAUAAAAAAAAAAAAAAD/fwAA/38AAAAAAAAJAAAABAAAAG0AOwAeAAAAaAAAAAAAAAAAAAAAAAAAAAAAAAAAAAAAECcAABAnAAAAAAAAAAAAAAAAAAAAAAAAAAAAAAAAAAAAAAAAAAAAABQAAAAAAAAAwMD/AAAAAABkAAAAMgAAAAAAAABkAAAAAAAAAH9/fwAKAAAAIgAAABgAAAAAAAAAAAAAAAAAAAAAAAAAAAAAAAAAAAAkAAAAJAAAAAAAAAAHAAAAAAAAAAAAAAAAAAAAAAAAAAAAAAAAAAAAf39/ACUAAABYAAAAAAAAAAAAAAAAAAAAAAAAAAAAAAAAAAAAAAAAAAAAAAAAAAAAAAAAAAAAAAA/AAAAAAAAAKCGAQAAAAAAAAAAAAAAAAAMAAAAAQAAAAAAAAAAAAAAAAAAAB8AAABUAAAAAAAABQAAAAEAAAAAAAAAAAAAAAAAAAAAAAAAAAAAAAAAAAAAAAAAAAAAAAJ/f38AAAAAA8zMzADAwP8Af39/AAAAAAAAAAAAAAAAAAAAAAAAAAAAIQAAABgAAAAUAAAAHjQAAEAmAAB/NwAAeikAABAAAAAmAAAACAAAAL2/AAD/HwAA"/>
               </a:ext>
             </a:extLst>
           </p:cNvSpPr>
@@ -8296,10 +8179,11 @@
               </a:spcAft>
               <a:buNone/>
             </a:pPr>
-            <a:fld id="{3FC2142E-60D2-97E2-9C7A-96B75A346AC3}" type="slidenum">
+            <a:fld id="{3FDAA907-49D2-8F5F-9C62-BF0AE72C6AEA}" type="slidenum">
               <a:rPr lang="ru-ru" cap="none"/>
               <a:t/>
             </a:fld>
+            <a:endParaRPr lang="ru-ru" cap="none"/>
           </a:p>
         </p:txBody>
       </p:sp>
@@ -8952,7 +8836,7 @@
             <a:spLocks noGrp="1" noChangeArrowheads="1"/>
             <a:extLst>
               <a:ext uri="smNativeData">
-                <pr:smNativeData xmlns:pr="smNativeData" xmlns="smNativeData" val="SMDATA_15_EkJ5ZhMAAAAlAAAAZAAAAA0AAAAAkAAAAJAAAACQAAAAkAAAAAAAAAAAAAAAAAAAAAEAAABQAAAAAAAAAAAA4D8AAAAAAADgPwAAAAAAAOA/AAAAAAAA4D8AAAAAAADgPwAAAAAAAOA/AAAAAAAA4D8AAAAAAADgPwAAAAAAAOA/AAAAAAAA4D8CAAAAjAAAAAAAAAAAAAAAQoX0DP///wgAAAAAAAAAAAAAAAAAAAAAAAAAAAAAAAAAAAAAZAAAAAEAAABAAAAAAAAAAAAAAAAAAAAAAAAAAAAAAAAAAAAAAAAAAAAAAAAAAAAAAAAAAAAAAAAAAAAAAAAAAAAAAAAAAAAAAAAAAAAAAAAAAAAAAAAAAAAAAAAAAAAAFAAAADwAAAAAAAAAAAAAAAAAAAkUAAAAAQAAABQAAAAUAAAAFAAAAAEAAAAAAAAAZAAAAGQAAAAAAAAAZAAAAGQAAAAVAAAAYAAAAAAAAAAAAAAADwAAACADAAAAAAAAAAAAAAEAAACgMgAAVgcAAKr4//8BAAAAf39/AAEAAABkAAAAAAAAABQAAABAHwAAAAAAACYAAAAAAAAAwOD//wAAAAAmAAAAZAAAABYAAABMAAAAAAAAAAAAAAAEAAAAAAAAAAEAAABZWVkKAAAAACgAAAAoAAAAZAAAAGQAAAAAAAAAzMzMAAAAAABQAAAAUAAAAGQAAABkAAAAAAAAABcAAAAUAAAAAAAAAAAAAAD/fwAA/38AAAAAAAAJAAAABAAAAAAAAAAeAAAAaAAAAAAAAAAAAAAAAAAAAAAAAAAAAAAAECcAABAnAAAAAAAAAAAAAAAAAAAAAAAAAAAAAAAAAAAAAAAAAAAAABQAAAAAAAAAwMD/AAAAAABkAAAAMgAAAAAAAABkAAAAAAAAAH9/fwAKAAAAIgAAABgAAAAAAAAAAAAAAAAAAAAAAAAAAAAAAAAAAAAkAAAAJAAAAAAAAAAHAAAAAAAAAAAAAAAAAAAAAAAAAAAAAAAAAAAAf39/ACUAAABYAAAAAAAAAAAAAAAAAAAAAAAAAAAAAAAAAAAAAAAAAAAAAAAAAAAAAAAAAAAAAAA/AAAAAAAAAKCGAQAAAAAAAAAAAAAAAAAMAAAAAQAAAAAAAAAAAAAAAAAAAB8AAABUAAAAAAAABQAAAAEAAAAAAAAAAAAAAAAAAAAAAAAAAAAAAAAAAAAAAAAAAAAAAAJ/f38AWVlZA8zMzADAwP8Af39/AAAAAAAAAAAAAAAAAAAAAAAAAAAAIQAAABgAAAAUAAAA5wQAAD8jAAD6IwAAvykAABAAAAAmAAAACAAAADwwAAAAAAAA"/>
+                <pr:smNativeData xmlns:pr="smNativeData" xmlns="smNativeData" val="SMDATA_15_LkR5ZhMAAAAlAAAAZAAAAA0AAAAAkAAAAJAAAACQAAAAkAAAAAAAAAAAAAAAAAAAAAEAAABQAAAAAAAAAAAA4D8AAAAAAADgPwAAAAAAAOA/AAAAAAAA4D8AAAAAAADgPwAAAAAAAOA/AAAAAAAA4D8AAAAAAADgPwAAAAAAAOA/AAAAAAAA4D8CAAAAjAAAAAAAAAAAAAAAQoX0DP///wgAAAAAAAAAAAAAAAAAAAAAAAAAAAAAAAAAAAAAZAAAAAEAAABAAAAAAAAAAAAAAAAAAAAAAAAAAAAAAAAAAAAAAAAAAAAAAAAAAAAAAAAAAAAAAAAAAAAAAAAAAAAAAAAAAAAAAAAAAAAAAAAAAAAAAAAAAAAAAAAAAAAAFAAAADwAAAAAAAAAAAAAAAAAAAkUAAAAAQAAABQAAAAUAAAAFAAAAAEAAAAAAAAAZAAAAGQAAAAAAAAAZAAAAGQAAAAVAAAAYAAAAAAAAAAAAAAADwAAACADAAAAAAAAAAAAAAEAAACgMgAAVgcAAKr4//8BAAAAf39/AAEAAABkAAAAAAAAABQAAABAHwAAAAAAACYAAAAAAAAAwOD//wAAAAAmAAAAZAAAABYAAABMAAAAAAAAAAAAAAAEAAAAAAAAAAEAAABZWVkKAAAAACgAAAAoAAAAZAAAAGQAAAAAAAAAzMzMAAAAAABQAAAAUAAAAGQAAABkAAAAAAAAABcAAAAUAAAAAAAAAAAAAAD/fwAA/38AAAAAAAAJAAAABAAAAAAAAAAeAAAAaAAAAAAAAAAAAAAAAAAAAAAAAAAAAAAAECcAABAnAAAAAAAAAAAAAAAAAAAAAAAAAAAAAAAAAAAAAAAAAAAAABQAAAAAAAAAwMD/AAAAAABkAAAAMgAAAAAAAABkAAAAAAAAAH9/fwAKAAAAIgAAABgAAAAAAAAAAAAAAAAAAAAAAAAAAAAAAAAAAAAkAAAAJAAAAAAAAAAHAAAAAAAAAAAAAAAAAAAAAAAAAAAAAAAAAAAAf39/ACUAAABYAAAAAAAAAAAAAAAAAAAAAAAAAAAAAAAAAAAAAAAAAAAAAAAAAAAAAAAAAAAAAAA/AAAAAAAAAKCGAQAAAAAAAAAAAAAAAAAMAAAAAQAAAAAAAAAAAAAAAAAAAB8AAABUAAAAQoX0Bf///wEAAAAAAAAAAAAAAAAAAAAAAAAAAAAAAAAAAAAAAAAAAAAAAAJ/f38AWVlZA8zMzADAwP8Af39/AAAAAAAAAAAAAAAAAAAAAAAAAAAAIQAAABgAAAAUAAAA5wQAAD8jAAD6IwAAvykAABAAAAAmAAAACAAAADwwAAAAAAAA"/>
               </a:ext>
             </a:extLst>
           </p:cNvSpPr>
@@ -8982,6 +8866,7 @@
               <a:rPr lang="ru-ru" cap="none"/>
               <a:t>otus.ru</a:t>
             </a:r>
+            <a:endParaRPr lang="ru-ru" cap="none"/>
           </a:p>
         </p:txBody>
       </p:sp>
@@ -8992,7 +8877,7 @@
             <a:spLocks noGrp="1" noChangeArrowheads="1"/>
             <a:extLst>
               <a:ext uri="smNativeData">
-                <pr:smNativeData xmlns:pr="smNativeData" xmlns="smNativeData" val="SMDATA_15_EkJ5ZhMAAAAlAAAAZAAAAA0AAAAAkAAAAJAAAACQAAAAkAAAAAAAAAAAAAAAAAAAAAEAAABQAAAAAAAAAAAA4D8AAAAAAADgPwAAAAAAAOA/AAAAAAAA4D8AAAAAAADgPwAAAAAAAOA/AAAAAAAA4D8AAAAAAADgPwAAAAAAAOA/AAAAAAAA4D8CAAAAjAAAAAAAAAAAAAAAQoX0DP///wgAAAAAAAAAAAAAAAAAAAAAAAAAAAAAAAAAAAAAZAAAAAEAAABAAAAAAAAAAAAAAAAAAAAAAAAAAAAAAAAAAAAAAAAAAAAAAAAAAAAAAAAAAAAAAAAAAAAAAAAAAAAAAAAAAAAAAAAAAAAAAAAAAAAAAAAAAAAAAAAAAAAAFAAAADwAAAAAAAAAAAAAAAAAAAkUAAAAAQAAABQAAAAUAAAAFAAAAAEAAAAAAAAAZAAAAGQAAAAAAAAAZAAAAGQAAAAVAAAAYAAAAAAAAAAAAAAADwAAACADAAAAAAAAAAAAAAEAAACgMgAAVgcAAKr4//8BAAAAf39/AAEAAABkAAAAAAAAABQAAABAHwAAAAAAACYAAAAAAAAAwOD//wAAAAAmAAAAZAAAABYAAABMAAAAAAAAAAAAAAAEAAAAAAAAAAEAAABZWVkKAAAAACgAAAAoAAAAZAAAAGQAAAAAAAAAzMzMAAAAAABQAAAAUAAAAGQAAABkAAAAAAAAABcAAAAUAAAAAAAAAAAAAAD/fwAA/38AAAAAAAAJAAAABAAAAAAAAAAeAAAAaAAAAAAAAAAAAAAAAAAAAAAAAAAAAAAAECcAABAnAAAAAAAAAAAAAAAAAAAAAAAAAAAAAAAAAAAAAAAAAAAAABQAAAAAAAAAwMD/AAAAAABkAAAAMgAAAAAAAABkAAAAAAAAAH9/fwAKAAAAIgAAABgAAAAAAAAAAAAAAAAAAAAAAAAAAAAAAAAAAAAkAAAAJAAAAAAAAAAHAAAAAAAAAAAAAAAAAAAAAAAAAAAAAAAAAAAAf39/ACUAAABYAAAAAAAAAAAAAAAAAAAAAAAAAAAAAAAAAAAAAAAAAAAAAAAAAAAAAAAAAAAAAAA/AAAAAAAAAKCGAQAAAAAAAAAAAAAAAAAMAAAAAQAAAAAAAAAAAAAAAAAAAB8AAABUAAAAAAAABQAAAAEAAAAAAAAAAAAAAAAAAAAAAAAAAAAAAAAAAAAAAAAAAAAAAAJ/f38AWVlZA8zMzADAwP8Af39/AAAAAAAAAAAAAAAAAAAAAAAAAAAAIQAAABgAAAAUAAAA5wQAAMMPAACROAAAfyQAABAAAAAmAAAACAAAADwwAAAAAAAA"/>
+                <pr:smNativeData xmlns:pr="smNativeData" xmlns="smNativeData" val="SMDATA_15_LkR5ZhMAAAAlAAAAZAAAAA0AAAAAkAAAAJAAAACQAAAAkAAAAAAAAAAAAAAAAAAAAAEAAABQAAAAAAAAAAAA4D8AAAAAAADgPwAAAAAAAOA/AAAAAAAA4D8AAAAAAADgPwAAAAAAAOA/AAAAAAAA4D8AAAAAAADgPwAAAAAAAOA/AAAAAAAA4D8CAAAAjAAAAAAAAAAAAAAAQoX0DP///wgAAAAAAAAAAAAAAAAAAAAAAAAAAAAAAAAAAAAAZAAAAAEAAABAAAAAAAAAAAAAAAAAAAAAAAAAAAAAAAAAAAAAAAAAAAAAAAAAAAAAAAAAAAAAAAAAAAAAAAAAAAAAAAAAAAAAAAAAAAAAAAAAAAAAAAAAAAAAAAAAAAAAFAAAADwAAAAAAAAAAAAAAAAAAAkUAAAAAQAAABQAAAAUAAAAFAAAAAEAAAAAAAAAZAAAAGQAAAAAAAAAZAAAAGQAAAAVAAAAYAAAAAAAAAAAAAAADwAAACADAAAAAAAAAAAAAAEAAACgMgAAVgcAAKr4//8BAAAAf39/AAEAAABkAAAAAAAAABQAAABAHwAAAAAAACYAAAAAAAAAwOD//wAAAAAmAAAAZAAAABYAAABMAAAAAAAAAAAAAAAEAAAAAAAAAAEAAABZWVkKAAAAACgAAAAoAAAAZAAAAGQAAAAAAAAAzMzMAAAAAABQAAAAUAAAAGQAAABkAAAAAAAAABcAAAAUAAAAAAAAAAAAAAD/fwAA/38AAAAAAAAJAAAABAAAAAAAAAAeAAAAaAAAAAAAAAAAAAAAAAAAAAAAAAAAAAAAECcAABAnAAAAAAAAAAAAAAAAAAAAAAAAAAAAAAAAAAAAAAAAAAAAABQAAAAAAAAAwMD/AAAAAABkAAAAMgAAAAAAAABkAAAAAAAAAH9/fwAKAAAAIgAAABgAAAAAAAAAAAAAAAAAAAAAAAAAAAAAAAAAAAAkAAAAJAAAAAAAAAAHAAAAAAAAAAAAAAAAAAAAAAAAAAAAAAAAAAAAf39/ACUAAABYAAAAAAAAAAAAAAAAAAAAAAAAAAAAAAAAAAAAAAAAAAAAAAAAAAAAAAAAAAAAAAA/AAAAAAAAAKCGAQAAAAAAAAAAAAAAAAAMAAAAAQAAAAAAAAAAAAAAAAAAAB8AAABUAAAAQoX0Bf///wEAAAAAAAAAAAAAAAAAAAAAAAAAAAAAAAAAAAAAAAAAAAAAAAJ/f38AWVlZA8zMzADAwP8Af39/AAAAAAAAAAAAAAAAAAAAAAAAAAAAIQAAABgAAAAUAAAA5wQAAMMPAACROAAAfyQAABAAAAAmAAAACAAAADwwAAAAAAAA"/>
               </a:ext>
             </a:extLst>
           </p:cNvSpPr>
@@ -9022,6 +8907,7 @@
               <a:rPr lang="ru-ru" cap="none"/>
               <a:t>Онлайн</a:t>
             </a:r>
+            <a:endParaRPr lang="ru-ru" cap="none"/>
           </a:p>
           <a:p>
             <a:pPr marL="0" indent="0" algn="l">
@@ -9037,6 +8923,7 @@
               <a:rPr lang="ru-ru" cap="none"/>
               <a:t>образование</a:t>
             </a:r>
+            <a:endParaRPr lang="ru-ru" cap="none"/>
           </a:p>
         </p:txBody>
       </p:sp>
@@ -9079,7 +8966,7 @@
             <a:spLocks noGrp="1" noChangeArrowheads="1"/>
             <a:extLst>
               <a:ext uri="smNativeData">
-                <pr:smNativeData xmlns:pr="smNativeData" xmlns="smNativeData" val="SMDATA_15_EkJ5ZhMAAAAlAAAAZAAAAA0AAAAAkAAAAJAAAACQAAAAkAAAAAAAAAAAAAAAAAAAAAEAAABQAAAAAAAAAAAA4D8AAAAAAADgPwAAAAAAAOA/AAAAAAAA4D8AAAAAAADgPwAAAAAAAOA/AAAAAAAA4D8AAAAAAADgPwAAAAAAAOA/AAAAAAAA4D8CAAAAjAAAAAAAAAAAAAAAQoX0DP///wgAAAAAAAAAAAAAAAAAAAAAAAAAAAAAAAAAAAAAZAAAAAEAAABAAAAAAAAAAAAAAAAAAAAAAAAAAAAAAAAAAAAAAAAAAAAAAAAAAAAAAAAAAAAAAAAAAAAAAAAAAAAAAAAAAAAAAAAAAAAAAAAAAAAAAAAAAAAAAAAAAAAAFAAAADwAAAAAAAAAAAAAAAAAAAkUAAAAAQAAABQAAAAUAAAAFAAAAAEAAAAAAAAAZAAAAGQAAAAAAAAAZAAAAGQAAAAVAAAAYAAAAAAAAAAAAAAADwAAACADAAAAAAAAAAAAAAEAAACgMgAAVgcAAKr4//8BAAAAf39/AAEAAABkAAAAAAAAABQAAABAHwAAAAAAACYAAAAAAAAAwOD//wAAAAAmAAAAZAAAABYAAABMAAAAAAAAAAAAAAAEAAAAAAAAAAEAAABZWVkKAAAAACgAAAAoAAAAZAAAAGQAAAAAAAAAzMzMAAAAAABQAAAAUAAAAGQAAABkAAAAAAAAABcAAAAUAAAAAAAAAAAAAAD/fwAA/38AAAAAAAAJAAAABAAAAAAAAAAeAAAAaAAAAAAAAAAAAAAAAAAAAAAAAAAAAAAAECcAABAnAAAAAAAAAAAAAAAAAAAAAAAAAAAAAAAAAAAAAAAAAAAAABQAAAAAAAAAwMD/AAAAAABkAAAAMgAAAAAAAABkAAAAAAAAAH9/fwAKAAAAIgAAABgAAAAAAAAAAAAAAAAAAAAAAAAAAAAAAAAAAAAkAAAAJAAAAAAAAAAHAAAAAAAAAAAAAAAAAAAAAAAAAAAAAAAAAAAAf39/ACUAAABYAAAAAAAAAAAAAAAAAAAAAAAAAAAAAAAAAAAAAAAAAAAAAAAAAAAAAAAAAAAAAAA/AAAAAAAAAKCGAQAAAAAAAAAAAAAAAAAMAAAAAQAAAAAAAAAAAAAAAAAAAB8AAABUAAAAAAAABQAAAAEAAAAAAAAAAAAAAAAAAAAAAAAAAAAAAAAAAAAAAAAAAAAAAAJ/f38AWVlZA8zMzADAwP8Af39/AAAAAAAAAAAAAAAAAAAAAAAAAAAAIQAAABgAAAAUAAAAFAMAALYCAAB/NwAAvwoAAAAAAAAmAAAACAAAAAEAAAAAAAAA"/>
+                <pr:smNativeData xmlns:pr="smNativeData" xmlns="smNativeData" val="SMDATA_15_LkR5ZhMAAAAlAAAAZAAAAA0AAAAAkAAAAJAAAACQAAAAkAAAAAAAAAAAAAAAAAAAAAEAAABQAAAAAAAAAAAA4D8AAAAAAADgPwAAAAAAAOA/AAAAAAAA4D8AAAAAAADgPwAAAAAAAOA/AAAAAAAA4D8AAAAAAADgPwAAAAAAAOA/AAAAAAAA4D8CAAAAjAAAAAAAAAAAAAAAQoX0DP///wgAAAAAAAAAAAAAAAAAAAAAAAAAAAAAAAAAAAAAZAAAAAEAAABAAAAAAAAAAAAAAAAAAAAAAAAAAAAAAAAAAAAAAAAAAAAAAAAAAAAAAAAAAAAAAAAAAAAAAAAAAAAAAAAAAAAAAAAAAAAAAAAAAAAAAAAAAAAAAAAAAAAAFAAAADwAAAAAAAAAAAAAAAAAAAkUAAAAAQAAABQAAAAUAAAAFAAAAAEAAAAAAAAAZAAAAGQAAAAAAAAAZAAAAGQAAAAVAAAAYAAAAAAAAAAAAAAADwAAACADAAAAAAAAAAAAAAEAAACgMgAAVgcAAKr4//8BAAAAf39/AAEAAABkAAAAAAAAABQAAABAHwAAAAAAACYAAAAAAAAAwOD//wAAAAAmAAAAZAAAABYAAABMAAAAAAAAAAAAAAAEAAAAAAAAAAEAAABZWVkKAAAAACgAAAAoAAAAZAAAAGQAAAAAAAAAzMzMAAAAAABQAAAAUAAAAGQAAABkAAAAAAAAABcAAAAUAAAAAAAAAAAAAAD/fwAA/38AAAAAAAAJAAAABAAAAAAAAAAeAAAAaAAAAAAAAAAAAAAAAAAAAAAAAAAAAAAAECcAABAnAAAAAAAAAAAAAAAAAAAAAAAAAAAAAAAAAAAAAAAAAAAAABQAAAAAAAAAwMD/AAAAAABkAAAAMgAAAAAAAABkAAAAAAAAAH9/fwAKAAAAIgAAABgAAAAAAAAAAAAAAAAAAAAAAAAAAAAAAAAAAAAkAAAAJAAAAAAAAAAHAAAAAAAAAAAAAAAAAAAAAAAAAAAAAAAAAAAAf39/ACUAAABYAAAAAAAAAAAAAAAAAAAAAAAAAAAAAAAAAAAAAAAAAAAAAAAAAAAAAAAAAAAAAAA/AAAAAAAAAKCGAQAAAAAAAAAAAAAAAAAMAAAAAQAAAAAAAAAAAAAAAAAAAB8AAABUAAAAQoX0Bf///wEAAAAAAAAAAAAAAAAAAAAAAAAAAAAAAAAAAAAAAAAAAAAAAAJ/f38AWVlZA8zMzADAwP8Af39/AAAAAAAAAAAAAAAAAAAAAAAAAAAAIQAAABgAAAAUAAAAFAMAALYCAAB/NwAAvwoAABAAAAAmAAAACAAAAAAAAAAAAAAA"/>
               </a:ext>
             </a:extLst>
           </p:cNvSpPr>
@@ -9087,12 +8974,7 @@
             <p:ph type="title"/>
           </p:nvPr>
         </p:nvSpPr>
-        <p:spPr>
-          <a:xfrm>
-            <a:off x="500380" y="440690"/>
-            <a:ext cx="8521065" cy="1306195"/>
-          </a:xfrm>
-        </p:spPr>
+        <p:spPr/>
         <p:txBody>
           <a:bodyPr/>
           <a:lstStyle/>
@@ -9111,7 +8993,7 @@
             <a:spLocks noGrp="1" noChangeArrowheads="1"/>
             <a:extLst>
               <a:ext uri="smNativeData">
-                <pr:smNativeData xmlns:pr="smNativeData" xmlns="smNativeData" val="SMDATA_15_EkJ5ZhMAAAAlAAAAZAAAAA0AAAAAkAAAAJAAAACQAAAAkAAAAAAAAAAAAAAAAAAAAAEAAABQAAAAAAAAAAAA4D8AAAAAAADgPwAAAAAAAOA/AAAAAAAA4D8AAAAAAADgPwAAAAAAAOA/AAAAAAAA4D8AAAAAAADgPwAAAAAAAOA/AAAAAAAA4D8CAAAAjAAAAAAAAAAAAAAAQoX0DP///wgAAAAAAAAAAAAAAAAAAAAAAAAAAAAAAAAAAAAAZAAAAAEAAABAAAAAAAAAAAAAAAAAAAAAAAAAAAAAAAAAAAAAAAAAAAAAAAAAAAAAAAAAAAAAAAAAAAAAAAAAAAAAAAAAAAAAAAAAAAAAAAAAAAAAAAAAAAAAAAAAAAAAFAAAADwAAAAAAAAAAAAAAAAAAAkUAAAAAQAAABQAAAAUAAAAFAAAAAEAAAAAAAAAZAAAAGQAAAAAAAAAZAAAAGQAAAAVAAAAYAAAAAAAAAAAAAAADwAAACADAAAAAAAAAAAAAAEAAACgMgAAVgcAAKr4//8BAAAAf39/AAEAAABkAAAAAAAAABQAAABAHwAAAAAAACYAAAAAAAAAwOD//wAAAAAmAAAAZAAAABYAAABMAAAAAAAAAAAAAAAEAAAAAAAAAAEAAABZWVkKAAAAACgAAAAoAAAAZAAAAGQAAAAAAAAAzMzMAAAAAABQAAAAUAAAAGQAAABkAAAAAAAAABcAAAAUAAAAAAAAAAAAAAD/fwAA/38AAAAAAAAJAAAABAAAAAAAAAAeAAAAaAAAAAAAAAAAAAAAAAAAAAAAAAAAAAAAECcAABAnAAAAAAAAAAAAAAAAAAAAAAAAAAAAAAAAAAAAAAAAAAAAABQAAAAAAAAAwMD/AAAAAABkAAAAMgAAAAAAAABkAAAAAAAAAH9/fwAKAAAAIgAAABgAAAAAAAAAAAAAAAAAAAAAAAAAAAAAAAAAAAAkAAAAJAAAAAAAAAAHAAAAAAAAAAAAAAAAAAAAAAAAAAAAAAAAAAAAf39/ACUAAABYAAAAAAAAAAAAAAAAAAAAAAAAAAAAAAAAAAAAAAAAAAAAAAAAAAAAAAAAAAAAAAA/AAAAAAAAAKCGAQAAAAAAAAAAAAAAAAAMAAAAAQAAAAAAAAAAAAAAAAAAAB8AAABUAAAAAAAABQAAAAEAAAAAAAAAAAAAAAAAAAAAAAAAAAAAAAAAAAAAAAAAAAAAAAJ/f38AWVlZA8zMzADAwP8Af39/AAAAAAAAAAAAAAAAAAAAAAAAAAAAIQAAABgAAAAUAAAAFAMAALMLAAB/NwAAuScAAAAAAAAmAAAACAAAAAEAAAAAAAAA"/>
+                <pr:smNativeData xmlns:pr="smNativeData" xmlns="smNativeData" val="SMDATA_15_LkR5ZhMAAAAlAAAAZAAAAA0AAAAAkAAAAJAAAACQAAAAkAAAAAAAAAAAAAAAAAAAAAEAAABQAAAAAAAAAAAA4D8AAAAAAADgPwAAAAAAAOA/AAAAAAAA4D8AAAAAAADgPwAAAAAAAOA/AAAAAAAA4D8AAAAAAADgPwAAAAAAAOA/AAAAAAAA4D8CAAAAjAAAAAAAAAAAAAAAQoX0DP///wgAAAAAAAAAAAAAAAAAAAAAAAAAAAAAAAAAAAAAZAAAAAEAAABAAAAAAAAAAAAAAAAAAAAAAAAAAAAAAAAAAAAAAAAAAAAAAAAAAAAAAAAAAAAAAAAAAAAAAAAAAAAAAAAAAAAAAAAAAAAAAAAAAAAAAAAAAAAAAAAAAAAAFAAAADwAAAAAAAAAAAAAAAAAAAkUAAAAAQAAABQAAAAUAAAAFAAAAAEAAAAAAAAAZAAAAGQAAAAAAAAAZAAAAGQAAAAVAAAAYAAAAAAAAAAAAAAADwAAACADAAAAAAAAAAAAAAEAAACgMgAAVgcAAKr4//8BAAAAf39/AAEAAABkAAAAAAAAABQAAABAHwAAAAAAACYAAAAAAAAAwOD//wAAAAAmAAAAZAAAABYAAABMAAAAAAAAAAAAAAAEAAAAAAAAAAEAAABZWVkKAAAAACgAAAAoAAAAZAAAAGQAAAAAAAAAzMzMAAAAAABQAAAAUAAAAGQAAABkAAAAAAAAABcAAAAUAAAAAAAAAAAAAAD/fwAA/38AAAAAAAAJAAAABAAAAAAAAAAeAAAAaAAAAAAAAAAAAAAAAAAAAAAAAAAAAAAAECcAABAnAAAAAAAAAAAAAAAAAAAAAAAAAAAAAAAAAAAAAAAAAAAAABQAAAAAAAAAwMD/AAAAAABkAAAAMgAAAAAAAABkAAAAAAAAAH9/fwAKAAAAIgAAABgAAAAAAAAAAAAAAAAAAAAAAAAAAAAAAAAAAAAkAAAAJAAAAAAAAAAHAAAAAAAAAAAAAAAAAAAAAAAAAAAAAAAAAAAAf39/ACUAAABYAAAAAAAAAAAAAAAAAAAAAAAAAAAAAAAAAAAAAAAAAAAAAAAAAAAAAAAAAAAAAAA/AAAAAAAAAKCGAQAAAAAAAAAAAAAAAAAMAAAAAQAAAAAAAAAAAAAAAAAAAB8AAABUAAAAQoX0Bf///wEAAAAAAAAAAAAAAAAAAAAAAAAAAAAAAAAAAAAAAAAAAAAAAAJ/f38AWVlZA8zMzADAwP8Af39/AAAAAAAAAAAAAAAAAAAAAAAAAAAAIQAAABgAAAAUAAAAFAMAALMLAAB/NwAAuScAABAAAAAmAAAACAAAAAAAAAAAAAAA"/>
               </a:ext>
             </a:extLst>
           </p:cNvSpPr>
@@ -9119,12 +9001,7 @@
             <p:ph type="body" idx="1"/>
           </p:nvPr>
         </p:nvSpPr>
-        <p:spPr>
-          <a:xfrm>
-            <a:off x="500380" y="1901825"/>
-            <a:ext cx="8521065" cy="4555490"/>
-          </a:xfrm>
-        </p:spPr>
+        <p:spPr/>
         <p:txBody>
           <a:bodyPr/>
           <a:lstStyle/>
@@ -9149,7 +9026,7 @@
             <a:picLocks noChangeAspect="1"/>
             <a:extLst>
               <a:ext uri="smNativeData">
-                <pr:smNativeData xmlns:pr="smNativeData" xmlns="smNativeData" val="SMDATA_17_EkJ5ZhMAAAAlAAAAEQAAAC8BAAAAkAAAAEgAAACQAAAASAAAAAAAAAAAAAAAAAAAAAEAAABQAAAAAAAAAAAA4D8AAAAAAADgPwAAAAAAAOA/AAAAAAAA4D8AAAAAAADgPwAAAAAAAOA/AAAAAAAA4D8AAAAAAADgPwAAAAAAAOA/AAAAAAAA4D8CAAAAjAAAAAAAAAAAAAAAQoX0DP///wgAAAAAAAAAAAAAAAAAAAAAAAAAAAAAAAAAAAAAZAAAAAEAAABAAAAAAAAAAAAAAAAAAAAAAAAAAAAAAAAAAAAAAAAAAAAAAAAAAAAAAAAAAAAAAAAAAAAAAAAAAAAAAAAAAAAAAAAAAAAAAAAAAAAAAAAAAAAAAAAAAAAAFAAAADwAAAAAAAAAAAAAAAAAAAkUAAAAAQAAABQAAAAUAAAAFAAAAAEAAAAAAAAAZAAAAGQAAAAAAAAAZAAAAGQAAAAVAAAAYAAAAAAAAAAAAAAADwAAACADAAAAAAAAAAAAAAEAAACgMgAAVgcAAKr4//8BAAAAf39/AAEAAABkAAAAAAAAABQAAABAHwAAAAAAACYAAAAAAAAAwOD//wAAAAAmAAAAZAAAABYAAABMAAAAAAAAAAAAAAAEAAAAAAAAAAEAAABZWVkKAAAAACgAAAAoAAAAZAAAAGQAAAAAAAAAzMzMAAAAAABQAAAAUAAAAGQAAABkAAAAAAAAAAcAAAA4AAAAAAAAAAAAAAAAAAAA////AAAAAAAAAAAAAAAAAAAAAAAAAAAAAAAAAAAAAABkAAAAZAAAAAAAAAAjAAAABAAAAGQAAAAXAAAAFAAAAAAAAAAAAAAA/38AAP9/AAAAAAAACQAAAAQAAAABAAAAHgAAAGgAAAAAAAAAAAAAAAAAAAAAAAAAAAAAABAnAAAQJwAAAAAAAAAAAAAAAAAAAAAAAAAAAAAAAAAAAAAAAAAAAAAUAAAAAAAAAMDA/wAAAAAAZAAAADIAAAAAAAAAZAAAAAAAAAB/f38ACgAAACIAAAAYAAAAAAAAAAAAAAAAAAAAAAAAAAAAAAAAAAAAJAAAACQAAAAAAAAABwAAAAAAAAAAAAAAAAAAAAAAAAAAAAAAAAAAAH9/fwAlAAAAWAAAAAAAAAAAAAAAAAAAAAAAAAAAAAAAAAAAAAAAAAAAAAAAAAAAAAAAAAAAAAAAPwAAAAAAAACghgEAAAAAAAAAAAAAAAAADAAAAAEAAAAAAAAAAAAAAAAAAAAfAAAAVAAAAEKF9AX///8BAAAAAAAAAAAAAAAAAAAAAAAAAAAAAAAAAAAAAAAAAAAAAAACf39/AFlZWQPMzMwAwMD/AH9/fwAAAAAAAAAAAAAAAAD///8AAAAAACEAAAAYAAAAFAAAAOwDAADNDgAA7yIAAA4nAAAAAAAAJgAAAAgAAAD//////////w=="/>
+                <pr:smNativeData xmlns:pr="smNativeData" xmlns="smNativeData" val="SMDATA_17_LkR5ZhMAAAAlAAAAEQAAAC8BAAAAkAAAAEgAAACQAAAASAAAAAAAAAAAAAAAAAAAAAEAAABQAAAAAAAAAAAA4D8AAAAAAADgPwAAAAAAAOA/AAAAAAAA4D8AAAAAAADgPwAAAAAAAOA/AAAAAAAA4D8AAAAAAADgPwAAAAAAAOA/AAAAAAAA4D8CAAAAjAAAAAAAAAAAAAAAQoX0DP///wgAAAAAAAAAAAAAAAAAAAAAAAAAAAAAAAAAAAAAZAAAAAEAAABAAAAAAAAAAAAAAAAAAAAAAAAAAAAAAAAAAAAAAAAAAAAAAAAAAAAAAAAAAAAAAAAAAAAAAAAAAAAAAAAAAAAAAAAAAAAAAAAAAAAAAAAAAAAAAAAAAAAAFAAAADwAAAAAAAAAAAAAAAAAAAkUAAAAAQAAABQAAAAUAAAAFAAAAAEAAAAAAAAAZAAAAGQAAAAAAAAAZAAAAGQAAAAVAAAAYAAAAAAAAAAAAAAADwAAACADAAAAAAAAAAAAAAEAAACgMgAAVgcAAKr4//8BAAAAf39/AAEAAABkAAAAAAAAABQAAABAHwAAAAAAACYAAAAAAAAAwOD//wAAAAAmAAAAZAAAABYAAABMAAAAAAAAAAAAAAAEAAAAAAAAAAEAAABZWVkKAAAAACgAAAAoAAAAZAAAAGQAAAAAAAAAzMzMAAAAAABQAAAAUAAAAGQAAABkAAAAAAAAAAcAAAA4AAAAAAAAAAAAAAAAAAAA////AAAAAAAAAAAAAAAAAAAAAAAAAAAAAAAAAAAAAABkAAAAZAAAAAAAAAAjAAAABAAAAGQAAAAXAAAAFAAAAAAAAAAAAAAA/38AAP9/AAAAAAAACQAAAAQAAAABAAAAHgAAAGgAAAAAAAAAAAAAAAAAAAAAAAAAAAAAABAnAAAQJwAAAAAAAAAAAAAAAAAAAAAAAAAAAAAAAAAAAAAAAAAAAAAUAAAAAAAAAMDA/wAAAAAAZAAAADIAAAAAAAAAZAAAAAAAAAB/f38ACgAAACIAAAAYAAAAAAAAAAAAAAAAAAAAAAAAAAAAAAAAAAAAJAAAACQAAAAAAAAABwAAAAAAAAAAAAAAAAAAAAAAAAAAAAAAAAAAAH9/fwAlAAAAWAAAAAAAAAAAAAAAAAAAAAAAAAAAAAAAAAAAAAAAAAAAAAAAAAAAAAAAAAAAAAAAPwAAAAAAAACghgEAAAAAAAAAAAAAAAAADAAAAAEAAAAAAAAAAAAAAAAAAAAfAAAAVAAAAEKF9AX///8BAAAAAAAAAAAAAAAAAAAAAAAAAAAAAAAAAAAAAAAAAAAAAAACf39/AFlZWQPMzMwAwMD/AH9/fwAAAAAAAAAAAAAAAAD///8AAAAAACEAAAAYAAAAFAAAAOwDAADNDgAA7yIAAA4nAAAQAAAAJgAAAAgAAAD//////////w=="/>
               </a:ext>
             </a:extLst>
           </p:cNvPicPr>
@@ -9215,7 +9092,7 @@
             <a:spLocks noGrp="1" noChangeArrowheads="1"/>
             <a:extLst>
               <a:ext uri="smNativeData">
-                <pr:smNativeData xmlns:pr="smNativeData" xmlns="smNativeData" val="SMDATA_15_EkJ5ZhMAAAAlAAAAZAAAAA0AAAAAkAAAAJAAAACQAAAAkAAAAAAAAAAAAAAAAAAAAAEAAABQAAAAAAAAAAAA4D8AAAAAAADgPwAAAAAAAOA/AAAAAAAA4D8AAAAAAADgPwAAAAAAAOA/AAAAAAAA4D8AAAAAAADgPwAAAAAAAOA/AAAAAAAA4D8CAAAAjAAAAAAAAAAAAAAAQoX0DP///wgAAAAAAAAAAAAAAAAAAAAAAAAAAAAAAAAAAAAAZAAAAAEAAABAAAAAAAAAAAAAAAAAAAAAAAAAAAAAAAAAAAAAAAAAAAAAAAAAAAAAAAAAAAAAAAAAAAAAAAAAAAAAAAAAAAAAAAAAAAAAAAAAAAAAAAAAAAAAAAAAAAAAFAAAADwAAAAAAAAAAAAAAAAAAAkUAAAAAQAAABQAAAAUAAAAFAAAAAEAAAAAAAAAZAAAAGQAAAAAAAAAZAAAAGQAAAAVAAAAYAAAAAAAAAAAAAAADwAAACADAAAAAAAAAAAAAAEAAACgMgAAVgcAAKr4//8BAAAAf39/AAEAAABkAAAAAAAAABQAAABAHwAAAAAAACYAAAAAAAAAwOD//wAAAAAmAAAAZAAAABYAAABMAAAAAAAAAAAAAAAEAAAAAAAAAAEAAABZWVkKAAAAACgAAAAoAAAAZAAAAGQAAAAAAAAAzMzMAAAAAABQAAAAUAAAAGQAAABkAAAAAAAAABcAAAAUAAAAAAAAAAAAAAD/fwAA/38AAAAAAAAJAAAABAAAAAAAAAAeAAAAaAAAAAAAAAAAAAAAAAAAAAAAAAAAAAAAECcAABAnAAAAAAAAAAAAAAAAAAAAAAAAAAAAAAAAAAAAAAAAAAAAABQAAAAAAAAAwMD/AAAAAABkAAAAMgAAAAAAAABkAAAAAAAAAH9/fwAKAAAAIgAAABgAAAAAAAAAAAAAAAAAAAAAAAAAAAAAAAAAAAAkAAAAJAAAAAAAAAAHAAAAAAAAAAAAAAAAAAAAAAAAAAAAAAAAAAAAf39/ACUAAABYAAAAAAAAAAAAAAAAAAAAAAAAAAAAAAAAAAAAAAAAAAAAAAAAAAAAAAAAAAAAAAA/AAAAAAAAAKCGAQAAAAAAAAAAAAAAAAAMAAAAAQAAAAAAAAAAAAAAAAAAAB8AAABUAAAAAAAABQAAAAEAAAAAAAAAAAAAAAAAAAAAAAAAAAAAAAAAAAAAAAAAAAAAAAJ/f38AWVlZA8zMzADAwP8Af39/AAAAAAAAAAAAAAAAAAAAAAAAAAAAIQAAABgAAAAUAAAAFAMAALYCAAB/NwAAvwoAAAAAAAAmAAAACAAAAAEAAAAAAAAA"/>
+                <pr:smNativeData xmlns:pr="smNativeData" xmlns="smNativeData" val="SMDATA_15_LkR5ZhMAAAAlAAAAZAAAAA0AAAAAkAAAAJAAAACQAAAAkAAAAAAAAAAAAAAAAAAAAAEAAABQAAAAAAAAAAAA4D8AAAAAAADgPwAAAAAAAOA/AAAAAAAA4D8AAAAAAADgPwAAAAAAAOA/AAAAAAAA4D8AAAAAAADgPwAAAAAAAOA/AAAAAAAA4D8CAAAAjAAAAAAAAAAAAAAAQoX0DP///wgAAAAAAAAAAAAAAAAAAAAAAAAAAAAAAAAAAAAAZAAAAAEAAABAAAAAAAAAAAAAAAAAAAAAAAAAAAAAAAAAAAAAAAAAAAAAAAAAAAAAAAAAAAAAAAAAAAAAAAAAAAAAAAAAAAAAAAAAAAAAAAAAAAAAAAAAAAAAAAAAAAAAFAAAADwAAAAAAAAAAAAAAAAAAAkUAAAAAQAAABQAAAAUAAAAFAAAAAEAAAAAAAAAZAAAAGQAAAAAAAAAZAAAAGQAAAAVAAAAYAAAAAAAAAAAAAAADwAAACADAAAAAAAAAAAAAAEAAACgMgAAVgcAAKr4//8BAAAAf39/AAEAAABkAAAAAAAAABQAAABAHwAAAAAAACYAAAAAAAAAwOD//wAAAAAmAAAAZAAAABYAAABMAAAAAAAAAAAAAAAEAAAAAAAAAAEAAABZWVkKAAAAACgAAAAoAAAAZAAAAGQAAAAAAAAAzMzMAAAAAABQAAAAUAAAAGQAAABkAAAAAAAAABcAAAAUAAAAAAAAAAAAAAD/fwAA/38AAAAAAAAJAAAABAAAAAAAAAAeAAAAaAAAAAAAAAAAAAAAAAAAAAAAAAAAAAAAECcAABAnAAAAAAAAAAAAAAAAAAAAAAAAAAAAAAAAAAAAAAAAAAAAABQAAAAAAAAAwMD/AAAAAABkAAAAMgAAAAAAAABkAAAAAAAAAH9/fwAKAAAAIgAAABgAAAAAAAAAAAAAAAAAAAAAAAAAAAAAAAAAAAAkAAAAJAAAAAAAAAAHAAAAAAAAAAAAAAAAAAAAAAAAAAAAAAAAAAAAf39/ACUAAABYAAAAAAAAAAAAAAAAAAAAAAAAAAAAAAAAAAAAAAAAAAAAAAAAAAAAAAAAAAAAAAA/AAAAAAAAAKCGAQAAAAAAAAAAAAAAAAAMAAAAAQAAAAAAAAAAAAAAAAAAAB8AAABUAAAAQoX0Bf///wEAAAAAAAAAAAAAAAAAAAAAAAAAAAAAAAAAAAAAAAAAAAAAAAJ/f38AWVlZA8zMzADAwP8Af39/AAAAAAAAAAAAAAAAAAAAAAAAAAAAIQAAABgAAAAUAAAAFAMAALYCAAB/NwAAvwoAABAAAAAmAAAACAAAAAAAAAAAAAAA"/>
               </a:ext>
             </a:extLst>
           </p:cNvSpPr>
@@ -9223,12 +9100,7 @@
             <p:ph type="title"/>
           </p:nvPr>
         </p:nvSpPr>
-        <p:spPr>
-          <a:xfrm>
-            <a:off x="500380" y="440690"/>
-            <a:ext cx="8521065" cy="1306195"/>
-          </a:xfrm>
-        </p:spPr>
+        <p:spPr/>
         <p:txBody>
           <a:bodyPr/>
           <a:lstStyle/>
@@ -9247,7 +9119,7 @@
             <a:spLocks noGrp="1" noChangeArrowheads="1"/>
             <a:extLst>
               <a:ext uri="smNativeData">
-                <pr:smNativeData xmlns:pr="smNativeData" xmlns="smNativeData" val="SMDATA_15_EkJ5ZhMAAAAlAAAAZAAAAA0AAAAAkAAAAJAAAACQAAAAkAAAAAAAAAAAAAAAAAAAAAEAAABQAAAAAAAAAAAA4D8AAAAAAADgPwAAAAAAAOA/AAAAAAAA4D8AAAAAAADgPwAAAAAAAOA/AAAAAAAA4D8AAAAAAADgPwAAAAAAAOA/AAAAAAAA4D8CAAAAjAAAAAAAAAAAAAAAQoX0DP///wgAAAAAAAAAAAAAAAAAAAAAAAAAAAAAAAAAAAAAZAAAAAEAAABAAAAAAAAAAAAAAAAAAAAAAAAAAAAAAAAAAAAAAAAAAAAAAAAAAAAAAAAAAAAAAAAAAAAAAAAAAAAAAAAAAAAAAAAAAAAAAAAAAAAAAAAAAAAAAAAAAAAAFAAAADwAAAAAAAAAAAAAAAAAAAkUAAAAAQAAABQAAAAUAAAAFAAAAAEAAAAAAAAAZAAAAGQAAAAAAAAAZAAAAGQAAAAVAAAAYAAAAAAAAAAAAAAADwAAACADAAAAAAAAAAAAAAEAAACgMgAAVgcAAKr4//8BAAAAf39/AAEAAABkAAAAAAAAABQAAABAHwAAAAAAACYAAAAAAAAAwOD//wAAAAAmAAAAZAAAABYAAABMAAAAAAAAAAAAAAAEAAAAAAAAAAEAAABZWVkKAAAAACgAAAAoAAAAZAAAAGQAAAAAAAAAzMzMAAAAAABQAAAAUAAAAGQAAABkAAAAAAAAABcAAAAUAAAAAAAAAAAAAAD/fwAA/38AAAAAAAAJAAAABAAAAAAAAAAeAAAAaAAAAAAAAAAAAAAAAAAAAAAAAAAAAAAAECcAABAnAAAAAAAAAAAAAAAAAAAAAAAAAAAAAAAAAAAAAAAAAAAAABQAAAAAAAAAwMD/AAAAAABkAAAAMgAAAAAAAABkAAAAAAAAAH9/fwAKAAAAIgAAABgAAAAAAAAAAAAAAAAAAAAAAAAAAAAAAAAAAAAkAAAAJAAAAAAAAAAHAAAAAAAAAAAAAAAAAAAAAAAAAAAAAAAAAAAAf39/ACUAAABYAAAAAAAAAAAAAAAAAAAAAAAAAAAAAAAAAAAAAAAAAAAAAAAAAAAAAAAAAAAAAAA/AAAAAAAAAKCGAQAAAAAAAAAAAAAAAAAMAAAAAQAAAAAAAAAAAAAAAAAAAB8AAABUAAAAAAAABQAAAAEAAAAAAAAAAAAAAAAAAAAAAAAAAAAAAAAAAAAAAAAAAAAAAAJ/f38AWVlZA8zMzADAwP8Af39/AAAAAAAAAAAAAAAAAAAAAAAAAAAAIQAAABgAAAAUAAAAFAMAALMLAAB/NwAAuScAAAAAAAAmAAAACAAAAAEAAAAAAAAA"/>
+                <pr:smNativeData xmlns:pr="smNativeData" xmlns="smNativeData" val="SMDATA_15_LkR5ZhMAAAAlAAAAZAAAAA0AAAAAkAAAAJAAAACQAAAAkAAAAAAAAAAAAAAAAAAAAAEAAABQAAAAAAAAAAAA4D8AAAAAAADgPwAAAAAAAOA/AAAAAAAA4D8AAAAAAADgPwAAAAAAAOA/AAAAAAAA4D8AAAAAAADgPwAAAAAAAOA/AAAAAAAA4D8CAAAAjAAAAAAAAAAAAAAAQoX0DP///wgAAAAAAAAAAAAAAAAAAAAAAAAAAAAAAAAAAAAAZAAAAAEAAABAAAAAAAAAAAAAAAAAAAAAAAAAAAAAAAAAAAAAAAAAAAAAAAAAAAAAAAAAAAAAAAAAAAAAAAAAAAAAAAAAAAAAAAAAAAAAAAAAAAAAAAAAAAAAAAAAAAAAFAAAADwAAAAAAAAAAAAAAAAAAAkUAAAAAQAAABQAAAAUAAAAFAAAAAEAAAAAAAAAZAAAAGQAAAAAAAAAZAAAAGQAAAAVAAAAYAAAAAAAAAAAAAAADwAAACADAAAAAAAAAAAAAAEAAACgMgAAVgcAAKr4//8BAAAAf39/AAEAAABkAAAAAAAAABQAAABAHwAAAAAAACYAAAAAAAAAwOD//wAAAAAmAAAAZAAAABYAAABMAAAAAAAAAAAAAAAEAAAAAAAAAAEAAABZWVkKAAAAACgAAAAoAAAAZAAAAGQAAAAAAAAAzMzMAAAAAABQAAAAUAAAAGQAAABkAAAAAAAAABcAAAAUAAAAAAAAAAAAAAD/fwAA/38AAAAAAAAJAAAABAAAAAAAAAAeAAAAaAAAAAAAAAAAAAAAAAAAAAAAAAAAAAAAECcAABAnAAAAAAAAAAAAAAAAAAAAAAAAAAAAAAAAAAAAAAAAAAAAABQAAAAAAAAAwMD/AAAAAABkAAAAMgAAAAAAAABkAAAAAAAAAH9/fwAKAAAAIgAAABgAAAAAAAAAAAAAAAAAAAAAAAAAAAAAAAAAAAAkAAAAJAAAAAAAAAAHAAAAAAAAAAAAAAAAAAAAAAAAAAAAAAAAAAAAf39/ACUAAABYAAAAAAAAAAAAAAAAAAAAAAAAAAAAAAAAAAAAAAAAAAAAAAAAAAAAAAAAAAAAAAA/AAAAAAAAAKCGAQAAAAAAAAAAAAAAAAAMAAAAAQAAAAAAAAAAAAAAAAAAAB8AAABUAAAAQoX0Bf///wEAAAAAAAAAAAAAAAAAAAAAAAAAAAAAAAAAAAAAAAAAAAAAAAJ/f38AWVlZA8zMzADAwP8Af39/AAAAAAAAAAAAAAAAAAAAAAAAAAAAIQAAABgAAAAUAAAAFAMAALMLAAB/NwAAuScAABAAAAAmAAAACAAAAAAAAAAAAAAA"/>
               </a:ext>
             </a:extLst>
           </p:cNvSpPr>
@@ -9255,12 +9127,7 @@
             <p:ph type="body" idx="1"/>
           </p:nvPr>
         </p:nvSpPr>
-        <p:spPr>
-          <a:xfrm>
-            <a:off x="500380" y="1901825"/>
-            <a:ext cx="8521065" cy="4555490"/>
-          </a:xfrm>
-        </p:spPr>
+        <p:spPr/>
         <p:txBody>
           <a:bodyPr/>
           <a:lstStyle/>
@@ -9285,7 +9152,7 @@
             <a:picLocks noChangeAspect="1"/>
             <a:extLst>
               <a:ext uri="smNativeData">
-                <pr:smNativeData xmlns:pr="smNativeData" xmlns="smNativeData" val="SMDATA_17_EkJ5ZhMAAAAlAAAAEQAAAC8BAAAAkAAAAEgAAACQAAAASAAAAAAAAAAAAAAAAAAAAAEAAABQAAAAAAAAAAAA4D8AAAAAAADgPwAAAAAAAOA/AAAAAAAA4D8AAAAAAADgPwAAAAAAAOA/AAAAAAAA4D8AAAAAAADgPwAAAAAAAOA/AAAAAAAA4D8CAAAAjAAAAAAAAAAAAAAAQoX0DP///wgAAAAAAAAAAAAAAAAAAAAAAAAAAAAAAAAAAAAAZAAAAAEAAABAAAAAAAAAAAAAAAAAAAAAAAAAAAAAAAAAAAAAAAAAAAAAAAAAAAAAAAAAAAAAAAAAAAAAAAAAAAAAAAAAAAAAAAAAAAAAAAAAAAAAAAAAAAAAAAAAAAAAFAAAADwAAAAAAAAAAAAAAAAAAAkUAAAAAQAAABQAAAAUAAAAFAAAAAEAAAAAAAAAZAAAAGQAAAAAAAAAZAAAAGQAAAAVAAAAYAAAAAAAAAAAAAAADwAAACADAAAAAAAAAAAAAAEAAACgMgAAVgcAAKr4//8BAAAAf39/AAEAAABkAAAAAAAAABQAAABAHwAAAAAAACYAAAAAAAAAwOD//wAAAAAmAAAAZAAAABYAAABMAAAAAAAAAAAAAAAEAAAAAAAAAAEAAABZWVkKAAAAACgAAAAoAAAAZAAAAGQAAAAAAAAAzMzMAAAAAABQAAAAUAAAAGQAAABkAAAAAAAAAAcAAAA4AAAAAAAAAAAAAAAAAAAA////AAAAAAAAAAAAAAAAAAAAAAAAAAAAAAAAAAAAAABkAAAAZAAAAAAAAAAjAAAABAAAAGQAAAAXAAAAFAAAAAAAAAAAAAAA/38AAP9/AAAAAAAACQAAAAQAAAAAAAAAHgAAAGgAAAAAAAAAAAAAAAAAAAAAAAAAAAAAABAnAAAQJwAAAAAAAAAAAAAAAAAAAAAAAAAAAAAAAAAAAAAAAAAAAAAUAAAAAAAAAMDA/wAAAAAAZAAAADIAAAAAAAAAZAAAAAAAAAB/f38ACgAAACIAAAAYAAAAAAAAAAAAAAAAAAAAAAAAAAAAAAAAAAAAJAAAACQAAAAAAAAABwAAAAAAAAAAAAAAAAAAAAAAAAAAAAAAAAAAAH9/fwAlAAAAWAAAAAAAAAAAAAAAAAAAAAAAAAAAAAAAAAAAAAAAAAAAAAAAAAAAAAAAAAAAAAAAPwAAAAAAAACghgEAAAAAAAAAAAAAAAAADAAAAAEAAAAAAAAAAAAAAAAAAAAfAAAAVAAAAEKF9AX///8BAAAAAAAAAAAAAAAAAAAAAAAAAAAAAAAAAAAAAAAAAAAAAAACf39/AFlZWQPMzMwAwMD/AH9/fwAAAAAAAAAAAAAAAAD///8AAAAAACEAAAAYAAAAFAAAACEEAADlDgAAuS8AAKMkAAAAAAAAJgAAAAgAAAD//////////w=="/>
+                <pr:smNativeData xmlns:pr="smNativeData" xmlns="smNativeData" val="SMDATA_17_LkR5ZhMAAAAlAAAAEQAAAC8BAAAAkAAAAEgAAACQAAAASAAAAAAAAAAAAAAAAAAAAAEAAABQAAAAAAAAAAAA4D8AAAAAAADgPwAAAAAAAOA/AAAAAAAA4D8AAAAAAADgPwAAAAAAAOA/AAAAAAAA4D8AAAAAAADgPwAAAAAAAOA/AAAAAAAA4D8CAAAAjAAAAAAAAAAAAAAAQoX0DP///wgAAAAAAAAAAAAAAAAAAAAAAAAAAAAAAAAAAAAAZAAAAAEAAABAAAAAAAAAAAAAAAAAAAAAAAAAAAAAAAAAAAAAAAAAAAAAAAAAAAAAAAAAAAAAAAAAAAAAAAAAAAAAAAAAAAAAAAAAAAAAAAAAAAAAAAAAAAAAAAAAAAAAFAAAADwAAAAAAAAAAAAAAAAAAAkUAAAAAQAAABQAAAAUAAAAFAAAAAEAAAAAAAAAZAAAAGQAAAAAAAAAZAAAAGQAAAAVAAAAYAAAAAAAAAAAAAAADwAAACADAAAAAAAAAAAAAAEAAACgMgAAVgcAAKr4//8BAAAAf39/AAEAAABkAAAAAAAAABQAAABAHwAAAAAAACYAAAAAAAAAwOD//wAAAAAmAAAAZAAAABYAAABMAAAAAAAAAAAAAAAEAAAAAAAAAAEAAABZWVkKAAAAACgAAAAoAAAAZAAAAGQAAAAAAAAAzMzMAAAAAABQAAAAUAAAAGQAAABkAAAAAAAAAAcAAAA4AAAAAAAAAAAAAAAAAAAA////AAAAAAAAAAAAAAAAAAAAAAAAAAAAAAAAAAAAAABkAAAAZAAAAAAAAAAjAAAABAAAAGQAAAAXAAAAFAAAAAAAAAAAAAAA/38AAP9/AAAAAAAACQAAAAQAAAAAAAAAHgAAAGgAAAAAAAAAAAAAAAAAAAAAAAAAAAAAABAnAAAQJwAAAAAAAAAAAAAAAAAAAAAAAAAAAAAAAAAAAAAAAAAAAAAUAAAAAAAAAMDA/wAAAAAAZAAAADIAAAAAAAAAZAAAAAAAAAB/f38ACgAAACIAAAAYAAAAAAAAAAAAAAAAAAAAAAAAAAAAAAAAAAAAJAAAACQAAAAAAAAABwAAAAAAAAAAAAAAAAAAAAAAAAAAAAAAAAAAAH9/fwAlAAAAWAAAAAAAAAAAAAAAAAAAAAAAAAAAAAAAAAAAAAAAAAAAAAAAAAAAAAAAAAAAAAAAPwAAAAAAAACghgEAAAAAAAAAAAAAAAAADAAAAAEAAAAAAAAAAAAAAAAAAAAfAAAAVAAAAEKF9AX///8BAAAAAAAAAAAAAAAAAAAAAAAAAAAAAAAAAAAAAAAAAAAAAAACf39/AFlZWQPMzMwAwMD/AH9/fwAAAAAAAAAAAAAAAAD///8AAAAAACEAAAAYAAAAFAAAACEEAADlDgAAuS8AAKMkAAAQAAAAJgAAAAgAAAD//////////w=="/>
               </a:ext>
             </a:extLst>
           </p:cNvPicPr>
@@ -9351,7 +9218,7 @@
             <a:spLocks noGrp="1" noChangeArrowheads="1"/>
             <a:extLst>
               <a:ext uri="smNativeData">
-                <pr:smNativeData xmlns:pr="smNativeData" xmlns="smNativeData" val="SMDATA_15_EkJ5ZhMAAAAlAAAAZAAAAA0AAAAAkAAAAJAAAACQAAAAkAAAAAAAAAAAAAAAAAAAAAEAAABQAAAAAAAAAAAA4D8AAAAAAADgPwAAAAAAAOA/AAAAAAAA4D8AAAAAAADgPwAAAAAAAOA/AAAAAAAA4D8AAAAAAADgPwAAAAAAAOA/AAAAAAAA4D8CAAAAjAAAAAAAAAAAAAAAQoX0DP///wgAAAAAAAAAAAAAAAAAAAAAAAAAAAAAAAAAAAAAZAAAAAEAAABAAAAAAAAAAAAAAAAAAAAAAAAAAAAAAAAAAAAAAAAAAAAAAAAAAAAAAAAAAAAAAAAAAAAAAAAAAAAAAAAAAAAAAAAAAAAAAAAAAAAAAAAAAAAAAAAAAAAAFAAAADwAAAAAAAAAAAAAAAAAAAkUAAAAAQAAABQAAAAUAAAAFAAAAAEAAAAAAAAAZAAAAGQAAAAAAAAAZAAAAGQAAAAVAAAAYAAAAAAAAAAAAAAADwAAACADAAAAAAAAAAAAAAEAAACgMgAAVgcAAKr4//8BAAAAf39/AAEAAABkAAAAAAAAABQAAABAHwAAAAAAACYAAAAAAAAAwOD//wAAAAAmAAAAZAAAABYAAABMAAAAAAAAAAAAAAAEAAAAAAAAAAEAAABZWVkKAAAAACgAAAAoAAAAZAAAAGQAAAAAAAAAzMzMAAAAAABQAAAAUAAAAGQAAABkAAAAAAAAABcAAAAUAAAAAAAAAAAAAAD/fwAA/38AAAAAAAAJAAAABAAAAAAAAAAeAAAAaAAAAAAAAAAAAAAAAAAAAAAAAAAAAAAAECcAABAnAAAAAAAAAAAAAAAAAAAAAAAAAAAAAAAAAAAAAAAAAAAAABQAAAAAAAAAwMD/AAAAAABkAAAAMgAAAAAAAABkAAAAAAAAAH9/fwAKAAAAIgAAABgAAAAAAAAAAAAAAAAAAAAAAAAAAAAAAAAAAAAkAAAAJAAAAAAAAAAHAAAAAAAAAAAAAAAAAAAAAAAAAAAAAAAAAAAAf39/ACUAAABYAAAAAAAAAAAAAAAAAAAAAAAAAAAAAAAAAAAAAAAAAAAAAAAAAAAAAAAAAAAAAAA/AAAAAAAAAKCGAQAAAAAAAAAAAAAAAAAMAAAAAQAAAAAAAAAAAAAAAAAAAB8AAABUAAAAQoX0Bf///wEAAAAAAAAAAAAAAAAAAAAAAAAAAAAAAAAAAAAAAAAAAAAAAAJ/f38AWVlZA8zMzADAwP8Af39/AAAAAAAAAAAAAAAAAAAAAAAAAAAAIQAAABgAAAAUAAAAFAMAALYCAAB/NwAAvwoAAAAAAAAmAAAACAAAAAEAAAAAAAAA"/>
+                <pr:smNativeData xmlns:pr="smNativeData" xmlns="smNativeData" val="SMDATA_15_LkR5ZhMAAAAlAAAAZAAAAA0AAAAAkAAAAJAAAACQAAAAkAAAAAAAAAAAAAAAAAAAAAEAAABQAAAAAAAAAAAA4D8AAAAAAADgPwAAAAAAAOA/AAAAAAAA4D8AAAAAAADgPwAAAAAAAOA/AAAAAAAA4D8AAAAAAADgPwAAAAAAAOA/AAAAAAAA4D8CAAAAjAAAAAAAAAAAAAAAQoX0DP///wgAAAAAAAAAAAAAAAAAAAAAAAAAAAAAAAAAAAAAZAAAAAEAAABAAAAAAAAAAAAAAAAAAAAAAAAAAAAAAAAAAAAAAAAAAAAAAAAAAAAAAAAAAAAAAAAAAAAAAAAAAAAAAAAAAAAAAAAAAAAAAAAAAAAAAAAAAAAAAAAAAAAAFAAAADwAAAAAAAAAAAAAAAAAAAkUAAAAAQAAABQAAAAUAAAAFAAAAAEAAAAAAAAAZAAAAGQAAAAAAAAAZAAAAGQAAAAVAAAAYAAAAAAAAAAAAAAADwAAACADAAAAAAAAAAAAAAEAAACgMgAAVgcAAKr4//8BAAAAf39/AAEAAABkAAAAAAAAABQAAABAHwAAAAAAACYAAAAAAAAAwOD//wAAAAAmAAAAZAAAABYAAABMAAAAAAAAAAAAAAAEAAAAAAAAAAEAAABZWVkKAAAAACgAAAAoAAAAZAAAAGQAAAAAAAAAzMzMAAAAAABQAAAAUAAAAGQAAABkAAAAAAAAABcAAAAUAAAAAAAAAAAAAAD/fwAA/38AAAAAAAAJAAAABAAAAAAAAAAeAAAAaAAAAAAAAAAAAAAAAAAAAAAAAAAAAAAAECcAABAnAAAAAAAAAAAAAAAAAAAAAAAAAAAAAAAAAAAAAAAAAAAAABQAAAAAAAAAwMD/AAAAAABkAAAAMgAAAAAAAABkAAAAAAAAAH9/fwAKAAAAIgAAABgAAAAAAAAAAAAAAAAAAAAAAAAAAAAAAAAAAAAkAAAAJAAAAAAAAAAHAAAAAAAAAAAAAAAAAAAAAAAAAAAAAAAAAAAAf39/ACUAAABYAAAAAAAAAAAAAAAAAAAAAAAAAAAAAAAAAAAAAAAAAAAAAAAAAAAAAAAAAAAAAAA/AAAAAAAAAKCGAQAAAAAAAAAAAAAAAAAMAAAAAQAAAAAAAAAAAAAAAAAAAB8AAABUAAAAQoX0Bf///wEAAAAAAAAAAAAAAAAAAAAAAAAAAAAAAAAAAAAAAAAAAAAAAAJ/f38AWVlZA8zMzADAwP8Af39/AAAAAAAAAAAAAAAAAAAAAAAAAAAAIQAAABgAAAAUAAAAFAMAALYCAAB/NwAAvwoAABAAAAAmAAAACAAAAAAAAAAAAAAA"/>
               </a:ext>
             </a:extLst>
           </p:cNvSpPr>
@@ -9359,12 +9226,7 @@
             <p:ph type="title"/>
           </p:nvPr>
         </p:nvSpPr>
-        <p:spPr>
-          <a:xfrm>
-            <a:off x="500380" y="440690"/>
-            <a:ext cx="8521065" cy="1306195"/>
-          </a:xfrm>
-        </p:spPr>
+        <p:spPr/>
         <p:txBody>
           <a:bodyPr/>
           <a:lstStyle/>
@@ -9383,7 +9245,7 @@
             <a:spLocks noGrp="1" noChangeArrowheads="1"/>
             <a:extLst>
               <a:ext uri="smNativeData">
-                <pr:smNativeData xmlns:pr="smNativeData" xmlns="smNativeData" val="SMDATA_15_EkJ5ZhMAAAAlAAAAZAAAAA0AAAAAkAAAAJAAAACQAAAAkAAAAAAAAAAAAAAAAAAAAAEAAABQAAAAAAAAAAAA4D8AAAAAAADgPwAAAAAAAOA/AAAAAAAA4D8AAAAAAADgPwAAAAAAAOA/AAAAAAAA4D8AAAAAAADgPwAAAAAAAOA/AAAAAAAA4D8CAAAAjAAAAAAAAAAAAAAAQoX0DP///wgAAAAAAAAAAAAAAAAAAAAAAAAAAAAAAAAAAAAAZAAAAAEAAABAAAAAAAAAAAAAAAAAAAAAAAAAAAAAAAAAAAAAAAAAAAAAAAAAAAAAAAAAAAAAAAAAAAAAAAAAAAAAAAAAAAAAAAAAAAAAAAAAAAAAAAAAAAAAAAAAAAAAFAAAADwAAAAAAAAAAAAAAAAAAAkUAAAAAQAAABQAAAAUAAAAFAAAAAEAAAAAAAAAZAAAAGQAAAAAAAAAZAAAAGQAAAAVAAAAYAAAAAAAAAAAAAAADwAAACADAAAAAAAAAAAAAAEAAACgMgAAVgcAAKr4//8BAAAAf39/AAEAAABkAAAAAAAAABQAAABAHwAAAAAAACYAAAAAAAAAwOD//wAAAAAmAAAAZAAAABYAAABMAAAAAAAAAAAAAAAEAAAAAAAAAAEAAABZWVkKAAAAACgAAAAoAAAAZAAAAGQAAAAAAAAAzMzMAAAAAABQAAAAUAAAAGQAAABkAAAAAAAAABcAAAAUAAAAAAAAAAAAAAD/fwAA/38AAAAAAAAJAAAABAAAAAAAAAAeAAAAaAAAAAAAAAAAAAAAAAAAAAAAAAAAAAAAECcAABAnAAAAAAAAAAAAAAAAAAAAAAAAAAAAAAAAAAAAAAAAAAAAABQAAAAAAAAAwMD/AAAAAABkAAAAMgAAAAAAAABkAAAAAAAAAH9/fwAKAAAAIgAAABgAAAAAAAAAAAAAAAAAAAAAAAAAAAAAAAAAAAAkAAAAJAAAAAAAAAAHAAAAAAAAAAAAAAAAAAAAAAAAAAAAAAAAAAAAf39/ACUAAABYAAAAAAAAAAAAAAAAAAAAAAAAAAAAAAAAAAAAAAAAAAAAAAAAAAAAAAAAAAAAAAA/AAAAAAAAAKCGAQAAAAAAAAAAAAAAAAAMAAAAAQAAAAAAAAAAAAAAAAAAAB8AAABUAAAAQoX0Bf///wEAAAAAAAAAAAAAAAAAAAAAAAAAAAAAAAAAAAAAAAAAAAAAAAJ/f38AWVlZA8zMzADAwP8Af39/AAAAAAAAAAAAAAAAAAAAAAAAAAAAIQAAABgAAAAUAAAAFAMAALMLAAB/NwAAuScAAAAAAAAmAAAACAAAAAEAAAAAAAAA"/>
+                <pr:smNativeData xmlns:pr="smNativeData" xmlns="smNativeData" val="SMDATA_15_LkR5ZhMAAAAlAAAAZAAAAA0AAAAAkAAAAJAAAACQAAAAkAAAAAAAAAAAAAAAAAAAAAEAAABQAAAAAAAAAAAA4D8AAAAAAADgPwAAAAAAAOA/AAAAAAAA4D8AAAAAAADgPwAAAAAAAOA/AAAAAAAA4D8AAAAAAADgPwAAAAAAAOA/AAAAAAAA4D8CAAAAjAAAAAAAAAAAAAAAQoX0DP///wgAAAAAAAAAAAAAAAAAAAAAAAAAAAAAAAAAAAAAZAAAAAEAAABAAAAAAAAAAAAAAAAAAAAAAAAAAAAAAAAAAAAAAAAAAAAAAAAAAAAAAAAAAAAAAAAAAAAAAAAAAAAAAAAAAAAAAAAAAAAAAAAAAAAAAAAAAAAAAAAAAAAAFAAAADwAAAAAAAAAAAAAAAAAAAkUAAAAAQAAABQAAAAUAAAAFAAAAAEAAAAAAAAAZAAAAGQAAAAAAAAAZAAAAGQAAAAVAAAAYAAAAAAAAAAAAAAADwAAACADAAAAAAAAAAAAAAEAAACgMgAAVgcAAKr4//8BAAAAf39/AAEAAABkAAAAAAAAABQAAABAHwAAAAAAACYAAAAAAAAAwOD//wAAAAAmAAAAZAAAABYAAABMAAAAAAAAAAAAAAAEAAAAAAAAAAEAAABZWVkKAAAAACgAAAAoAAAAZAAAAGQAAAAAAAAAzMzMAAAAAABQAAAAUAAAAGQAAABkAAAAAAAAABcAAAAUAAAAAAAAAAAAAAD/fwAA/38AAAAAAAAJAAAABAAAAAAAAAAeAAAAaAAAAAAAAAAAAAAAAAAAAAAAAAAAAAAAECcAABAnAAAAAAAAAAAAAAAAAAAAAAAAAAAAAAAAAAAAAAAAAAAAABQAAAAAAAAAwMD/AAAAAABkAAAAMgAAAAAAAABkAAAAAAAAAH9/fwAKAAAAIgAAABgAAAAAAAAAAAAAAAAAAAAAAAAAAAAAAAAAAAAkAAAAJAAAAAAAAAAHAAAAAAAAAAAAAAAAAAAAAAAAAAAAAAAAAAAAf39/ACUAAABYAAAAAAAAAAAAAAAAAAAAAAAAAAAAAAAAAAAAAAAAAAAAAAAAAAAAAAAAAAAAAAA/AAAAAAAAAKCGAQAAAAAAAAAAAAAAAAAMAAAAAQAAAAAAAAAAAAAAAAAAAB8AAABUAAAAQoX0Bf///wEAAAAAAAAAAAAAAAAAAAAAAAAAAAAAAAAAAAAAAAAAAAAAAAJ/f38AWVlZA8zMzADAwP8Af39/AAAAAAAAAAAAAAAAAAAAAAAAAAAAIQAAABgAAAAUAAAAFAMAALMLAAB/NwAAuScAABAAAAAmAAAACAAAAAAAAAAAAAAA"/>
               </a:ext>
             </a:extLst>
           </p:cNvSpPr>
@@ -9391,12 +9253,7 @@
             <p:ph type="body" idx="1"/>
           </p:nvPr>
         </p:nvSpPr>
-        <p:spPr>
-          <a:xfrm>
-            <a:off x="500380" y="1901825"/>
-            <a:ext cx="8521065" cy="4555490"/>
-          </a:xfrm>
-        </p:spPr>
+        <p:spPr/>
         <p:txBody>
           <a:bodyPr/>
           <a:lstStyle/>
@@ -9421,7 +9278,7 @@
             <a:picLocks noChangeAspect="1"/>
             <a:extLst>
               <a:ext uri="smNativeData">
-                <pr:smNativeData xmlns:pr="smNativeData" xmlns="smNativeData" val="SMDATA_17_EkJ5ZhMAAAAlAAAAEQAAAC8BAAAAkAAAAEgAAACQAAAASAAAAAAAAAAAAAAAAAAAAAEAAABQAAAAAAAAAAAA4D8AAAAAAADgPwAAAAAAAOA/AAAAAAAA4D8AAAAAAADgPwAAAAAAAOA/AAAAAAAA4D8AAAAAAADgPwAAAAAAAOA/AAAAAAAA4D8CAAAAjAAAAAAAAAAAAAAAQoX0DP///wgAAAAAAAAAAAAAAAAAAAAAAAAAAAAAAAAAAAAAZAAAAAEAAABAAAAAAAAAAAAAAAAAAAAAAAAAAAAAAAAAAAAAAAAAAAAAAAAAAAAAAAAAAAAAAAAAAAAAAAAAAAAAAAAAAAAAAAAAAAAAAAAAAAAAAAAAAAAAAAAAAAAAFAAAADwAAAAAAAAAAAAAAAAAAAkUAAAAAQAAABQAAAAUAAAAFAAAAAEAAAAAAAAAZAAAAGQAAAAAAAAAZAAAAGQAAAAVAAAAYAAAAAAAAAAAAAAADwAAACADAAAAAAAAAAAAAAEAAACgMgAAVgcAAKr4//8BAAAAf39/AAEAAABkAAAAAAAAABQAAABAHwAAAAAAACYAAAAAAAAAwOD//wAAAAAmAAAAZAAAABYAAABMAAAAAAAAAAAAAAAEAAAAAAAAAAEAAABZWVkKAAAAACgAAAAoAAAAZAAAAGQAAAAAAAAAzMzMAAAAAABQAAAAUAAAAGQAAABkAAAAAAAAAAcAAAA4AAAAAAAAAAAAAAAAAAAA////AAAAAAAAAAAAAAAAAAAAAAAAAAAAAAAAAAAAAABkAAAAZAAAAAAAAAAjAAAABAAAAGQAAAAXAAAAFAAAAAAAAAAAAAAA/38AAP9/AAAAAAAACQAAAAQAAAAAAAAAHgAAAGgAAAAAAAAAAAAAAAAAAAAAAAAAAAAAABAnAAAQJwAAAAAAAAAAAAAAAAAAAAAAAAAAAAAAAAAAAAAAAAAAAAAUAAAAAAAAAMDA/wAAAAAAZAAAADIAAAAAAAAAZAAAAAAAAAB/f38ACgAAACIAAAAYAAAAAAAAAAAAAAAAAAAAAAAAAAAAAAAAAAAAJAAAACQAAAAAAAAABwAAAAAAAAAAAAAAAAAAAAAAAAAAAAAAAAAAAH9/fwAlAAAAWAAAAAAAAAAAAAAAAAAAAAAAAAAAAAAAAAAAAAAAAAAAAAAAAAAAAAAAAAAAAAAAPwAAAAAAAACghgEAAAAAAAAAAAAAAAAADAAAAAEAAAAAAAAAAAAAAAAAAAAfAAAAVAAAAEKF9AX///8BAAAAAAAAAAAAAAAAAAAAAAAAAAAAAAAAAAAAAAAAAAAAAAACf39/AFlZWQPMzMwAwMD/AH9/fwAAAAAAAAAAAAAAAAD///8AAAAAACEAAAAYAAAAFAAAAKADAACZDgAAIiMAAKUnAAAAAAAAJgAAAAgAAAD//////////w=="/>
+                <pr:smNativeData xmlns:pr="smNativeData" xmlns="smNativeData" val="SMDATA_17_LkR5ZhMAAAAlAAAAEQAAAC8BAAAAkAAAAEgAAACQAAAASAAAAAAAAAAAAAAAAAAAAAEAAABQAAAAAAAAAAAA4D8AAAAAAADgPwAAAAAAAOA/AAAAAAAA4D8AAAAAAADgPwAAAAAAAOA/AAAAAAAA4D8AAAAAAADgPwAAAAAAAOA/AAAAAAAA4D8CAAAAjAAAAAAAAAAAAAAAQoX0DP///wgAAAAAAAAAAAAAAAAAAAAAAAAAAAAAAAAAAAAAZAAAAAEAAABAAAAAAAAAAAAAAAAAAAAAAAAAAAAAAAAAAAAAAAAAAAAAAAAAAAAAAAAAAAAAAAAAAAAAAAAAAAAAAAAAAAAAAAAAAAAAAAAAAAAAAAAAAAAAAAAAAAAAFAAAADwAAAAAAAAAAAAAAAAAAAkUAAAAAQAAABQAAAAUAAAAFAAAAAEAAAAAAAAAZAAAAGQAAAAAAAAAZAAAAGQAAAAVAAAAYAAAAAAAAAAAAAAADwAAACADAAAAAAAAAAAAAAEAAACgMgAAVgcAAKr4//8BAAAAf39/AAEAAABkAAAAAAAAABQAAABAHwAAAAAAACYAAAAAAAAAwOD//wAAAAAmAAAAZAAAABYAAABMAAAAAAAAAAAAAAAEAAAAAAAAAAEAAABZWVkKAAAAACgAAAAoAAAAZAAAAGQAAAAAAAAAzMzMAAAAAABQAAAAUAAAAGQAAABkAAAAAAAAAAcAAAA4AAAAAAAAAAAAAAAAAAAA////AAAAAAAAAAAAAAAAAAAAAAAAAAAAAAAAAAAAAABkAAAAZAAAAAAAAAAjAAAABAAAAGQAAAAXAAAAFAAAAAAAAAAAAAAA/38AAP9/AAAAAAAACQAAAAQAAAAAAAAAHgAAAGgAAAAAAAAAAAAAAAAAAAAAAAAAAAAAABAnAAAQJwAAAAAAAAAAAAAAAAAAAAAAAAAAAAAAAAAAAAAAAAAAAAAUAAAAAAAAAMDA/wAAAAAAZAAAADIAAAAAAAAAZAAAAAAAAAB/f38ACgAAACIAAAAYAAAAAAAAAAAAAAAAAAAAAAAAAAAAAAAAAAAAJAAAACQAAAAAAAAABwAAAAAAAAAAAAAAAAAAAAAAAAAAAAAAAAAAAH9/fwAlAAAAWAAAAAAAAAAAAAAAAAAAAAAAAAAAAAAAAAAAAAAAAAAAAAAAAAAAAAAAAAAAAAAAPwAAAAAAAACghgEAAAAAAAAAAAAAAAAADAAAAAEAAAAAAAAAAAAAAAAAAAAfAAAAVAAAAEKF9AX///8BAAAAAAAAAAAAAAAAAAAAAAAAAAAAAAAAAAAAAAAAAAAAAAACf39/AFlZWQPMzMwAwMD/AH9/fwAAAAAAAAAAAAAAAAD///8AAAAAACEAAAAYAAAAFAAAAKADAACZDgAAIiMAAKUnAAAQAAAAJgAAAAgAAAD//////////w=="/>
               </a:ext>
             </a:extLst>
           </p:cNvPicPr>
@@ -9487,7 +9344,7 @@
             <a:spLocks noGrp="1" noChangeArrowheads="1"/>
             <a:extLst>
               <a:ext uri="smNativeData">
-                <pr:smNativeData xmlns:pr="smNativeData" xmlns="smNativeData" val="SMDATA_15_EkJ5ZhMAAAAlAAAAZAAAAA0AAAAAkAAAAJAAAACQAAAAkAAAAAAAAAAAAAAAAAAAAAEAAABQAAAAAAAAAAAA4D8AAAAAAADgPwAAAAAAAOA/AAAAAAAA4D8AAAAAAADgPwAAAAAAAOA/AAAAAAAA4D8AAAAAAADgPwAAAAAAAOA/AAAAAAAA4D8CAAAAjAAAAAAAAAAAAAAAQoX0DP///wgAAAAAAAAAAAAAAAAAAAAAAAAAAAAAAAAAAAAAZAAAAAEAAABAAAAAAAAAAAAAAAAAAAAAAAAAAAAAAAAAAAAAAAAAAAAAAAAAAAAAAAAAAAAAAAAAAAAAAAAAAAAAAAAAAAAAAAAAAAAAAAAAAAAAAAAAAAAAAAAAAAAAFAAAADwAAAAAAAAAAAAAAAAAAAkUAAAAAQAAABQAAAAUAAAAFAAAAAEAAAAAAAAAZAAAAGQAAAAAAAAAZAAAAGQAAAAVAAAAYAAAAAAAAAAAAAAADwAAACADAAAAAAAAAAAAAAEAAACgMgAAVgcAAKr4//8BAAAAf39/AAEAAABkAAAAAAAAABQAAABAHwAAAAAAACYAAAAAAAAAwOD//wAAAAAmAAAAZAAAABYAAABMAAAAAAAAAAAAAAAEAAAAAAAAAAEAAABZWVkKAAAAACgAAAAoAAAAZAAAAGQAAAAAAAAAzMzMAAAAAABQAAAAUAAAAGQAAABkAAAAAAAAABcAAAAUAAAAAAAAAAAAAAD/fwAA/38AAAAAAAAJAAAABAAAAAAAAAAeAAAAaAAAAAAAAAAAAAAAAAAAAAAAAAAAAAAAECcAABAnAAAAAAAAAAAAAAAAAAAAAAAAAAAAAAAAAAAAAAAAAAAAABQAAAAAAAAAwMD/AAAAAABkAAAAMgAAAAAAAABkAAAAAAAAAH9/fwAKAAAAIgAAABgAAAAAAAAAAAAAAAAAAAAAAAAAAAAAAAAAAAAkAAAAJAAAAAAAAAAHAAAAAAAAAAAAAAAAAAAAAAAAAAAAAAAAAAAAf39/ACUAAABYAAAAAAAAAAAAAAAAAAAAAAAAAAAAAAAAAAAAAAAAAAAAAAAAAAAAAAAAAAAAAAA/AAAAAAAAAKCGAQAAAAAAAAAAAAAAAAAMAAAAAQAAAAAAAAAAAAAAAAAAAB8AAABUAAAAQoX0Bf///wEAAAAAAAAAAAAAAAAAAAAAAAAAAAAAAAAAAAAAAAAAAAAAAAJ/f38AWVlZA8zMzADAwP8Af39/AAAAAAAAAAAAAAAAAAAAAAAAAAAAIQAAABgAAAAUAAAAFAMAALYCAAB/NwAAvwoAAAAAAAAmAAAACAAAAAEAAAAAAAAA"/>
+                <pr:smNativeData xmlns:pr="smNativeData" xmlns="smNativeData" val="SMDATA_15_LkR5ZhMAAAAlAAAAZAAAAA0AAAAAkAAAAJAAAACQAAAAkAAAAAAAAAAAAAAAAAAAAAEAAABQAAAAAAAAAAAA4D8AAAAAAADgPwAAAAAAAOA/AAAAAAAA4D8AAAAAAADgPwAAAAAAAOA/AAAAAAAA4D8AAAAAAADgPwAAAAAAAOA/AAAAAAAA4D8CAAAAjAAAAAAAAAAAAAAAQoX0DP///wgAAAAAAAAAAAAAAAAAAAAAAAAAAAAAAAAAAAAAZAAAAAEAAABAAAAAAAAAAAAAAAAAAAAAAAAAAAAAAAAAAAAAAAAAAAAAAAAAAAAAAAAAAAAAAAAAAAAAAAAAAAAAAAAAAAAAAAAAAAAAAAAAAAAAAAAAAAAAAAAAAAAAFAAAADwAAAAAAAAAAAAAAAAAAAkUAAAAAQAAABQAAAAUAAAAFAAAAAEAAAAAAAAAZAAAAGQAAAAAAAAAZAAAAGQAAAAVAAAAYAAAAAAAAAAAAAAADwAAACADAAAAAAAAAAAAAAEAAACgMgAAVgcAAKr4//8BAAAAf39/AAEAAABkAAAAAAAAABQAAABAHwAAAAAAACYAAAAAAAAAwOD//wAAAAAmAAAAZAAAABYAAABMAAAAAAAAAAAAAAAEAAAAAAAAAAEAAABZWVkKAAAAACgAAAAoAAAAZAAAAGQAAAAAAAAAzMzMAAAAAABQAAAAUAAAAGQAAABkAAAAAAAAABcAAAAUAAAAAAAAAAAAAAD/fwAA/38AAAAAAAAJAAAABAAAAAAAAAAeAAAAaAAAAAAAAAAAAAAAAAAAAAAAAAAAAAAAECcAABAnAAAAAAAAAAAAAAAAAAAAAAAAAAAAAAAAAAAAAAAAAAAAABQAAAAAAAAAwMD/AAAAAABkAAAAMgAAAAAAAABkAAAAAAAAAH9/fwAKAAAAIgAAABgAAAAAAAAAAAAAAAAAAAAAAAAAAAAAAAAAAAAkAAAAJAAAAAAAAAAHAAAAAAAAAAAAAAAAAAAAAAAAAAAAAAAAAAAAf39/ACUAAABYAAAAAAAAAAAAAAAAAAAAAAAAAAAAAAAAAAAAAAAAAAAAAAAAAAAAAAAAAAAAAAA/AAAAAAAAAKCGAQAAAAAAAAAAAAAAAAAMAAAAAQAAAAAAAAAAAAAAAAAAAB8AAABUAAAAQoX0Bf///wEAAAAAAAAAAAAAAAAAAAAAAAAAAAAAAAAAAAAAAAAAAAAAAAJ/f38AWVlZA8zMzADAwP8Af39/AAAAAAAAAAAAAAAAAAAAAAAAAAAAIQAAABgAAAAUAAAAFAMAALYCAAB/NwAAvwoAABAAAAAmAAAACAAAAAAAAAAAAAAA"/>
               </a:ext>
             </a:extLst>
           </p:cNvSpPr>
@@ -9495,12 +9352,7 @@
             <p:ph type="title"/>
           </p:nvPr>
         </p:nvSpPr>
-        <p:spPr>
-          <a:xfrm>
-            <a:off x="500380" y="440690"/>
-            <a:ext cx="8521065" cy="1306195"/>
-          </a:xfrm>
-        </p:spPr>
+        <p:spPr/>
         <p:txBody>
           <a:bodyPr/>
           <a:lstStyle/>
@@ -9519,7 +9371,7 @@
             <a:spLocks noGrp="1" noChangeArrowheads="1"/>
             <a:extLst>
               <a:ext uri="smNativeData">
-                <pr:smNativeData xmlns:pr="smNativeData" xmlns="smNativeData" val="SMDATA_15_EkJ5ZhMAAAAlAAAAZAAAAA0AAAAAkAAAAJAAAACQAAAAkAAAAAAAAAAAAAAAAAAAAAEAAABQAAAAAAAAAAAA4D8AAAAAAADgPwAAAAAAAOA/AAAAAAAA4D8AAAAAAADgPwAAAAAAAOA/AAAAAAAA4D8AAAAAAADgPwAAAAAAAOA/AAAAAAAA4D8CAAAAjAAAAAAAAAAAAAAAQoX0DP///wgAAAAAAAAAAAAAAAAAAAAAAAAAAAAAAAAAAAAAZAAAAAEAAABAAAAAAAAAAAAAAAAAAAAAAAAAAAAAAAAAAAAAAAAAAAAAAAAAAAAAAAAAAAAAAAAAAAAAAAAAAAAAAAAAAAAAAAAAAAAAAAAAAAAAAAAAAAAAAAAAAAAAFAAAADwAAAAAAAAAAAAAAAAAAAkUAAAAAQAAABQAAAAUAAAAFAAAAAEAAAAAAAAAZAAAAGQAAAAAAAAAZAAAAGQAAAAVAAAAYAAAAAAAAAAAAAAADwAAACADAAAAAAAAAAAAAAEAAACgMgAAVgcAAKr4//8BAAAAf39/AAEAAABkAAAAAAAAABQAAABAHwAAAAAAACYAAAAAAAAAwOD//wAAAAAmAAAAZAAAABYAAABMAAAAAAAAAAAAAAAEAAAAAAAAAAEAAABZWVkKAAAAACgAAAAoAAAAZAAAAGQAAAAAAAAAzMzMAAAAAABQAAAAUAAAAGQAAABkAAAAAAAAABcAAAAUAAAAAAAAAAAAAAD/fwAA/38AAAAAAAAJAAAABAAAAAAAAAAeAAAAaAAAAAAAAAAAAAAAAAAAAAAAAAAAAAAAECcAABAnAAAAAAAAAAAAAAAAAAAAAAAAAAAAAAAAAAAAAAAAAAAAABQAAAAAAAAAwMD/AAAAAABkAAAAMgAAAAAAAABkAAAAAAAAAH9/fwAKAAAAIgAAABgAAAAAAAAAAAAAAAAAAAAAAAAAAAAAAAAAAAAkAAAAJAAAAAAAAAAHAAAAAAAAAAAAAAAAAAAAAAAAAAAAAAAAAAAAf39/ACUAAABYAAAAAAAAAAAAAAAAAAAAAAAAAAAAAAAAAAAAAAAAAAAAAAAAAAAAAAAAAAAAAAA/AAAAAAAAAKCGAQAAAAAAAAAAAAAAAAAMAAAAAQAAAAAAAAAAAAAAAAAAAB8AAABUAAAAQoX0Bf///wEAAAAAAAAAAAAAAAAAAAAAAAAAAAAAAAAAAAAAAAAAAAAAAAJ/f38AWVlZA8zMzADAwP8Af39/AAAAAAAAAAAAAAAAAAAAAAAAAAAAIQAAABgAAAAUAAAAFAMAALMLAAB/NwAAuScAAAAAAAAmAAAACAAAAAEAAAAAAAAA"/>
+                <pr:smNativeData xmlns:pr="smNativeData" xmlns="smNativeData" val="SMDATA_15_LkR5ZhMAAAAlAAAAZAAAAA0AAAAAkAAAAJAAAACQAAAAkAAAAAAAAAAAAAAAAAAAAAEAAABQAAAAAAAAAAAA4D8AAAAAAADgPwAAAAAAAOA/AAAAAAAA4D8AAAAAAADgPwAAAAAAAOA/AAAAAAAA4D8AAAAAAADgPwAAAAAAAOA/AAAAAAAA4D8CAAAAjAAAAAAAAAAAAAAAQoX0DP///wgAAAAAAAAAAAAAAAAAAAAAAAAAAAAAAAAAAAAAZAAAAAEAAABAAAAAAAAAAAAAAAAAAAAAAAAAAAAAAAAAAAAAAAAAAAAAAAAAAAAAAAAAAAAAAAAAAAAAAAAAAAAAAAAAAAAAAAAAAAAAAAAAAAAAAAAAAAAAAAAAAAAAFAAAADwAAAAAAAAAAAAAAAAAAAkUAAAAAQAAABQAAAAUAAAAFAAAAAEAAAAAAAAAZAAAAGQAAAAAAAAAZAAAAGQAAAAVAAAAYAAAAAAAAAAAAAAADwAAACADAAAAAAAAAAAAAAEAAACgMgAAVgcAAKr4//8BAAAAf39/AAEAAABkAAAAAAAAABQAAABAHwAAAAAAACYAAAAAAAAAwOD//wAAAAAmAAAAZAAAABYAAABMAAAAAAAAAAAAAAAEAAAAAAAAAAEAAABZWVkKAAAAACgAAAAoAAAAZAAAAGQAAAAAAAAAzMzMAAAAAABQAAAAUAAAAGQAAABkAAAAAAAAABcAAAAUAAAAAAAAAAAAAAD/fwAA/38AAAAAAAAJAAAABAAAAAAAAAAeAAAAaAAAAAAAAAAAAAAAAAAAAAAAAAAAAAAAECcAABAnAAAAAAAAAAAAAAAAAAAAAAAAAAAAAAAAAAAAAAAAAAAAABQAAAAAAAAAwMD/AAAAAABkAAAAMgAAAAAAAABkAAAAAAAAAH9/fwAKAAAAIgAAABgAAAAAAAAAAAAAAAAAAAAAAAAAAAAAAAAAAAAkAAAAJAAAAAAAAAAHAAAAAAAAAAAAAAAAAAAAAAAAAAAAAAAAAAAAf39/ACUAAABYAAAAAAAAAAAAAAAAAAAAAAAAAAAAAAAAAAAAAAAAAAAAAAAAAAAAAAAAAAAAAAA/AAAAAAAAAKCGAQAAAAAAAAAAAAAAAAAMAAAAAQAAAAAAAAAAAAAAAAAAAB8AAABUAAAAQoX0Bf///wEAAAAAAAAAAAAAAAAAAAAAAAAAAAAAAAAAAAAAAAAAAAAAAAJ/f38AWVlZA8zMzADAwP8Af39/AAAAAAAAAAAAAAAAAAAAAAAAAAAAIQAAABgAAAAUAAAAFAMAALMLAAB/NwAAuScAABAAAAAmAAAACAAAAAAAAAAAAAAA"/>
               </a:ext>
             </a:extLst>
           </p:cNvSpPr>
@@ -9527,12 +9379,7 @@
             <p:ph type="body" idx="1"/>
           </p:nvPr>
         </p:nvSpPr>
-        <p:spPr>
-          <a:xfrm>
-            <a:off x="500380" y="1901825"/>
-            <a:ext cx="8521065" cy="4555490"/>
-          </a:xfrm>
-        </p:spPr>
+        <p:spPr/>
         <p:txBody>
           <a:bodyPr/>
           <a:lstStyle/>
@@ -9601,7 +9448,7 @@
             <a:spLocks noGrp="1" noChangeArrowheads="1"/>
             <a:extLst>
               <a:ext uri="smNativeData">
-                <pr:smNativeData xmlns:pr="smNativeData" xmlns="smNativeData" val="SMDATA_15_EkJ5ZhMAAAAlAAAAZAAAAA0AAAAAkAAAAJAAAACQAAAAkAAAAAAAAAAAAAAAAAAAAAEAAABQAAAAAAAAAAAA4D8AAAAAAADgPwAAAAAAAOA/AAAAAAAA4D8AAAAAAADgPwAAAAAAAOA/AAAAAAAA4D8AAAAAAADgPwAAAAAAAOA/AAAAAAAA4D8CAAAAjAAAAAAAAAAAAAAAQoX0DP///wgAAAAAAAAAAAAAAAAAAAAAAAAAAAAAAAAAAAAAZAAAAAEAAABAAAAAAAAAAAAAAAAAAAAAAAAAAAAAAAAAAAAAAAAAAAAAAAAAAAAAAAAAAAAAAAAAAAAAAAAAAAAAAAAAAAAAAAAAAAAAAAAAAAAAAAAAAAAAAAAAAAAAFAAAADwAAAAAAAAAAAAAAAAAAAkUAAAAAQAAABQAAAAUAAAAFAAAAAEAAAAAAAAAZAAAAGQAAAAAAAAAZAAAAGQAAAAVAAAAYAAAAAAAAAAAAAAADwAAACADAAAAAAAAAAAAAAEAAACgMgAAVgcAAKr4//8BAAAAf39/AAEAAABkAAAAAAAAABQAAABAHwAAAAAAACYAAAAAAAAAwOD//wAAAAAmAAAAZAAAABYAAABMAAAAAAAAAAAAAAAEAAAAAAAAAAEAAABZWVkKAAAAACgAAAAoAAAAZAAAAGQAAAAAAAAAzMzMAAAAAABQAAAAUAAAAGQAAABkAAAAAAAAABcAAAAUAAAAAAAAAAAAAAD/fwAA/38AAAAAAAAJAAAABAAAADtUGRUeAAAAaAAAAAAAAAAAAAAAAAAAAAAAAAAAAAAAECcAABAnAAAAAAAAAAAAAAAAAAAAAAAAAAAAAAAAAAAAAAAAAAAAABQAAAAAAAAAwMD/AAAAAABkAAAAMgAAAAAAAABkAAAAAAAAAH9/fwAKAAAAIgAAABgAAAAAAAAAAAAAAAAAAAAAAAAAAAAAAAAAAAAkAAAAJAAAAAAAAAAHAAAAAAAAAAAAAAAAAAAAAAAAAAAAAAAAAAAAf39/ACUAAABYAAAAAAAAAAAAAAAAAAAAAAAAAAAAAAAAAAAAAAAAAAAAAAAAAAAAAAAAAAAAAAA/AAAAAAAAAKCGAQAAAAAAAAAAAAAAAAAMAAAAAQAAAAAAAAAAAAAAAAAAAB8AAABUAAAAQoX0Bf///wEAAAAAAAAAAAAAAAAAAAAAAAAAAAAAAAAAAAAAAAAAAAAAAAJ/f38AWVlZA8zMzADAwP8Af39/AAAAAAAAAAAAAAAAAAAAAAAAAAAAIQAAABgAAAAUAAAA+gIAAIICAABlNwAAiwoAABAAAAAmAAAACAAAAD0wAAAAAAAA"/>
+                <pr:smNativeData xmlns:pr="smNativeData" xmlns="smNativeData" val="SMDATA_15_LkR5ZhMAAAAlAAAAZAAAAA0AAAAAkAAAAJAAAACQAAAAkAAAAAAAAAAAAAAAAAAAAAEAAABQAAAAAAAAAAAA4D8AAAAAAADgPwAAAAAAAOA/AAAAAAAA4D8AAAAAAADgPwAAAAAAAOA/AAAAAAAA4D8AAAAAAADgPwAAAAAAAOA/AAAAAAAA4D8CAAAAjAAAAAAAAAAAAAAAQoX0DP///wgAAAAAAAAAAAAAAAAAAAAAAAAAAAAAAAAAAAAAZAAAAAEAAABAAAAAAAAAAAAAAAAAAAAAAAAAAAAAAAAAAAAAAAAAAAAAAAAAAAAAAAAAAAAAAAAAAAAAAAAAAAAAAAAAAAAAAAAAAAAAAAAAAAAAAAAAAAAAAAAAAAAAFAAAADwAAAAAAAAAAAAAAAAAAAkUAAAAAQAAABQAAAAUAAAAFAAAAAEAAAAAAAAAZAAAAGQAAAAAAAAAZAAAAGQAAAAVAAAAYAAAAAAAAAAAAAAADwAAACADAAAAAAAAAAAAAAEAAACgMgAAVgcAAKr4//8BAAAAf39/AAEAAABkAAAAAAAAABQAAABAHwAAAAAAACYAAAAAAAAAwOD//wAAAAAmAAAAZAAAABYAAABMAAAAAAAAAAAAAAAEAAAAAAAAAAEAAABZWVkKAAAAACgAAAAoAAAAZAAAAGQAAAAAAAAAzMzMAAAAAABQAAAAUAAAAGQAAABkAAAAAAAAABcAAAAUAAAAAAAAAAAAAAD/fwAA/38AAAAAAAAJAAAABAAAADtUGRUeAAAAaAAAAAAAAAAAAAAAAAAAAAAAAAAAAAAAECcAABAnAAAAAAAAAAAAAAAAAAAAAAAAAAAAAAAAAAAAAAAAAAAAABQAAAAAAAAAwMD/AAAAAABkAAAAMgAAAAAAAABkAAAAAAAAAH9/fwAKAAAAIgAAABgAAAAAAAAAAAAAAAAAAAAAAAAAAAAAAAAAAAAkAAAAJAAAAAAAAAAHAAAAAAAAAAAAAAAAAAAAAAAAAAAAAAAAAAAAf39/ACUAAABYAAAAAAAAAAAAAAAAAAAAAAAAAAAAAAAAAAAAAAAAAAAAAAAAAAAAAAAAAAAAAAA/AAAAAAAAAKCGAQAAAAAAAAAAAAAAAAAMAAAAAQAAAAAAAAAAAAAAAAAAAB8AAABUAAAAQoX0Bf///wEAAAAAAAAAAAAAAAAAAAAAAAAAAAAAAAAAAAAAAAAAAAAAAAJ/f38AWVlZA8zMzADAwP8Af39/AAAAAAAAAAAAAAAAAAAAAAAAAAAAIQAAABgAAAAUAAAA+gIAAIICAABlNwAAiwoAABAAAAAmAAAACAAAAD0wAAAAAAAA"/>
               </a:ext>
             </a:extLst>
           </p:cNvSpPr>
@@ -9636,6 +9483,7 @@
               <a:rPr lang="ru-ru" cap="none"/>
               <a:t>Схемы (архитектура, БД)</a:t>
             </a:r>
+            <a:endParaRPr lang="ru-ru" cap="none"/>
           </a:p>
           <a:p>
             <a:pPr marL="0" indent="0" algn="l">
@@ -9667,7 +9515,7 @@
           <p:cNvSpPr>
             <a:extLst>
               <a:ext uri="smNativeData">
-                <pr:smNativeData xmlns:pr="smNativeData" xmlns="smNativeData" val="SMDATA_15_EkJ5ZhMAAAAlAAAA9AEAAA0AAAAAOAEAAMYAAAA4AQAAxgAAAAAAAAABAAAAAAAAAAEAAABQAAAAtSRVET1m6b8FJ9au5qX6vwAAAAAAAOA/AAAAAAAA4D8AAAAAAADgPwAAAAAAAOA/AAAAAAAA4D8AAAAAAADgPwAAAAAAAOA/AAAAAAAA4D8CAAAAjAAAAAEAAAAAAAAA8/PzAP///wgAAAAAAAAAAAAAAAAAAAAAAAAAAAAAAAAAAAAAeAAAAAEAAABAAAAAAAAAAAAAAABaAAAAAAAAAAAAAAAAAAAAAAAAAAAAAAAAAAAAAAAAAAAAAAAAAAAAAAAAAAAAAAAAAAAAAAAAAAAAAAAAAAAAAAAAAAAAAAAAAAAAFAAAADwAAAABAAAAAAAAAAE9hQAPAAAAAQAAACMAAAAjAAAAIwAAAB4AAAAAAAAASwAAAEsAAAAAAAAASwAAAEsAAAAVAAAAYAAAAAAAAAAAAAAADwAAACADAAAAAAAAAAAAAAEAAACgMgAAVgcAAKr4//8BAAAAf39/AAEAAABkAAAAAAAAABQAAABAHwAAAAAAACYAAAAAAAAAwOD//wAAAAAmAAAAZAAAABYAAABMAAAAAAAAAAAAAAAEAAAAAAAAAAEAAABZWVkKAAAAACgAAAAoAAAAZAAAAGQAAAAAAAAAzMzMAAAAAABQAAAAUAAAAGQAAABkAAAAAAAAABcAAAAUAAAAAAAAAAAAAAD/fwAA/38AAAAAAAAJAAAABAAAAG+pTlkeAAAAaAAAAAAAAAAAAAAAAAAAAAAAAAAAAAAAECcAABAnAAAAAAAAAAAAAAAAAAAAAAAAAAAAAAAAAAAAAAAAAAAAABQAAAAAAAAAwMD/AAAAAABkAAAAMgAAAAAAAABkAAAAAAAAAH9/fwAKAAAAIgAAABgAAAAAAAAAAAAAAAAAAAAAAAAAAAAAAAAAAAAkAAAAJAAAAAAAAAAHAAAAAAAAAAAAAAAAAAAAAAAAAAAAAAAAAAAAf39/ACUAAABYAAAAAAAAAAAAAAAAAAAAAAAAAAAAAAAAAAAAAAAAAAAAAAAAAAAAAAAAAAAAAAA/AAAAAAAAAKCGAQAAAAAAAAAAAAAAAAAMAAAAAQAAAAAAAAAAAAAAAAAAAB8AAABUAAAA8/PzAP///wEAAAAAAAAAAAAAAAAAAAAAAAAAAAAAAAAAAAAAAAAAAAE9hQB/f38AWVlZA8zMzADAwP8Af39/AAAAAAAAAAAAAAAAAAAAAAAAAAAAIQAAABgAAAAUAAAAvR0AAO0fAADMMgAApCYAABAAAAAmAAAACAAAAP//////////"/>
+                <pr:smNativeData xmlns:pr="smNativeData" xmlns="smNativeData" val="SMDATA_15_LkR5ZhMAAAAlAAAA9AEAAA0AAAAAOAEAAMYAAAA4AQAAxgAAAAAAAAABAAAAAAAAAAEAAABQAAAAtSRVET1m6b8FJ9au5qX6vwAAAAAAAOA/AAAAAAAA4D8AAAAAAADgPwAAAAAAAOA/AAAAAAAA4D8AAAAAAADgPwAAAAAAAOA/AAAAAAAA4D8CAAAAjAAAAAEAAAAAAAAA8/PzAP///wgAAAAAAAAAAAAAAAAAAAAAAAAAAAAAAAAAAAAAeAAAAAEAAABAAAAAAAAAAAAAAABaAAAAAAAAAAAAAAAAAAAAAAAAAAAAAAAAAAAAAAAAAAAAAAAAAAAAAAAAAAAAAAAAAAAAAAAAAAAAAAAAAAAAAAAAAAAAAAAAAAAAFAAAADwAAAABAAAAAAAAAAE9hQAPAAAAAQAAACMAAAAjAAAAIwAAAB4AAAAAAAAASwAAAEsAAAAAAAAASwAAAEsAAAAVAAAAYAAAAAAAAAAAAAAADwAAACADAAAAAAAAAAAAAAEAAACgMgAAVgcAAKr4//8BAAAAf39/AAEAAABkAAAAAAAAABQAAABAHwAAAAAAACYAAAAAAAAAwOD//wAAAAAmAAAAZAAAABYAAABMAAAAAAAAAAAAAAAEAAAAAAAAAAEAAABZWVkKAAAAACgAAAAoAAAAZAAAAGQAAAAAAAAAzMzMAAAAAABQAAAAUAAAAGQAAABkAAAAAAAAABcAAAAUAAAAAAAAAAAAAAD/fwAA/38AAAAAAAAJAAAABAAAAG+pTlkeAAAAaAAAAAAAAAAAAAAAAAAAAAAAAAAAAAAAECcAABAnAAAAAAAAAAAAAAAAAAAAAAAAAAAAAAAAAAAAAAAAAAAAABQAAAAAAAAAwMD/AAAAAABkAAAAMgAAAAAAAABkAAAAAAAAAH9/fwAKAAAAIgAAABgAAAAAAAAAAAAAAAAAAAAAAAAAAAAAAAAAAAAkAAAAJAAAAAAAAAAHAAAAAAAAAAAAAAAAAAAAAAAAAAAAAAAAAAAAf39/ACUAAABYAAAAAAAAAAAAAAAAAAAAAAAAAAAAAAAAAAAAAAAAAAAAAAAAAAAAAAAAAAAAAAA/AAAAAAAAAKCGAQAAAAAAAAAAAAAAAAAMAAAAAQAAAAAAAAAAAAAAAAAAAB8AAABUAAAA8/PzAP///wEAAAAAAAAAAAAAAAAAAAAAAAAAAAAAAAAAAAAAAAAAAAE9hQB/f38AWVlZA8zMzADAwP8Af39/AAAAAAAAAAAAAAAAAAAAAAAAAAAAIQAAABgAAAAUAAAAvR0AAO0fAADMMgAApCYAABAAAAAmAAAACAAAAP//////////"/>
               </a:ext>
             </a:extLst>
           </p:cNvSpPr>
@@ -9739,7 +9587,7 @@
             <a:picLocks noChangeAspect="1"/>
             <a:extLst>
               <a:ext uri="smNativeData">
-                <pr:smNativeData xmlns:pr="smNativeData" xmlns="smNativeData" val="SMDATA_17_EkJ5ZhMAAAAlAAAAEQAAAC8BAAAAkAAAAEgAAACQAAAASAAAAAAAAAAAAAAAAAAAAAEAAABQAAAAAAAAAAAA4D8AAAAAAADgPwAAAAAAAOA/AAAAAAAA4D8AAAAAAADgPwAAAAAAAOA/AAAAAAAA4D8AAAAAAADgPwAAAAAAAOA/AAAAAAAA4D8CAAAAjAAAAAAAAAAAAAAAQoX0DP///wgAAAAAAAAAAAAAAAAAAAAAAAAAAAAAAAAAAAAAZAAAAAEAAABAAAAAAAAAAAAAAAAAAAAAAAAAAAAAAAAAAAAAAAAAAAAAAAAAAAAAAAAAAAAAAAAAAAAAAAAAAAAAAAAAAAAAAAAAAAAAAAAAAAAAAAAAAAAAAAAAAAAAFAAAADwAAAAAAAAAAAAAAAAAAAkUAAAAAQAAABQAAAAUAAAAFAAAAAEAAAAAAAAAZAAAAGQAAAAAAAAAZAAAAGQAAAAVAAAAYAAAAAAAAAAAAAAADwAAACADAAAAAAAAAAAAAAEAAACgMgAAVgcAAKr4//8BAAAAf39/AAEAAABkAAAAAAAAABQAAABAHwAAAAAAACYAAAAAAAAAwOD//wAAAAAmAAAAZAAAABYAAABMAAAAAAAAAAAAAAAEAAAAAAAAAAEAAABZWVkKAAAAACgAAAAoAAAAZAAAAGQAAAAAAAAAzMzMAAAAAABQAAAAUAAAAGQAAABkAAAAAAAAAAcAAAA4AAAAAAAAAAAAAAAAAAAA////AAAAAAAAAAAAAAAAAAAAAAAAAAAAAAAAAAAAAABkAAAAZAAAAAAAAAAjAAAABAAAAGQAAAAXAAAAFAAAAAAAAAAAAAAA/38AAP9/AAAAAAAACQAAAAQAAAAOAAAAHgAAAGgAAAAAAAAAAAAAAAAAAAAAAAAAAAAAABAnAAAQJwAAAAAAAAAAAAAAAAAAAAAAAAAAAAAAAAAAAAAAAAAAAAAUAAAAAAAAAMDA/wAAAAAAZAAAADIAAAAAAAAAZAAAAAAAAAB/f38ACgAAACIAAAAYAAAAAAAAAAAAAAAAAAAAAAAAAAAAAAAAAAAAJAAAACQAAAAAAAAABwAAAAAAAAAAAAAAAAAAAAAAAAAAAAAAAAAAAH9/fwAlAAAAWAAAAAAAAAAAAAAAAAAAAAAAAAAAAAAAAAAAAAAAAAAAAAAAAAAAAAAAAAAAAAAAPwAAAAAAAACghgEAAAAAAAAAAAAAAAAADAAAAAEAAAAAAAAAAAAAAAAAAAAfAAAAVAAAAEKF9AX///8BAAAAAAAAAAAAAAAAAAAAAAAAAAAAAAAAAAAAAAAAAAAAAAACf39/AFlZWQPMzMwAwMD/AH9/fwAAAAAAAAAAAAAAAAD///8AAAAAACEAAAAYAAAAFAAAAAUDAAB5CwAAQzcAAMkcAAAAAAAAJgAAAAgAAAD//////////w=="/>
+                <pr:smNativeData xmlns:pr="smNativeData" xmlns="smNativeData" val="SMDATA_17_LkR5ZhMAAAAlAAAAEQAAAC8BAAAAkAAAAEgAAACQAAAASAAAAAAAAAAAAAAAAAAAAAEAAABQAAAAAAAAAAAA4D8AAAAAAADgPwAAAAAAAOA/AAAAAAAA4D8AAAAAAADgPwAAAAAAAOA/AAAAAAAA4D8AAAAAAADgPwAAAAAAAOA/AAAAAAAA4D8CAAAAjAAAAAAAAAAAAAAAQoX0DP///wgAAAAAAAAAAAAAAAAAAAAAAAAAAAAAAAAAAAAAZAAAAAEAAABAAAAAAAAAAAAAAAAAAAAAAAAAAAAAAAAAAAAAAAAAAAAAAAAAAAAAAAAAAAAAAAAAAAAAAAAAAAAAAAAAAAAAAAAAAAAAAAAAAAAAAAAAAAAAAAAAAAAAFAAAADwAAAAAAAAAAAAAAAAAAAkUAAAAAQAAABQAAAAUAAAAFAAAAAEAAAAAAAAAZAAAAGQAAAAAAAAAZAAAAGQAAAAVAAAAYAAAAAAAAAAAAAAADwAAACADAAAAAAAAAAAAAAEAAACgMgAAVgcAAKr4//8BAAAAf39/AAEAAABkAAAAAAAAABQAAABAHwAAAAAAACYAAAAAAAAAwOD//wAAAAAmAAAAZAAAABYAAABMAAAAAAAAAAAAAAAEAAAAAAAAAAEAAABZWVkKAAAAACgAAAAoAAAAZAAAAGQAAAAAAAAAzMzMAAAAAABQAAAAUAAAAGQAAABkAAAAAAAAAAcAAAA4AAAAAAAAAAAAAAAAAAAA////AAAAAAAAAAAAAAAAAAAAAAAAAAAAAAAAAAAAAABkAAAAZAAAAAAAAAAjAAAABAAAAGQAAAAXAAAAFAAAAAAAAAAAAAAA/38AAP9/AAAAAAAACQAAAAQAAAAOAAAAHgAAAGgAAAAAAAAAAAAAAAAAAAAAAAAAAAAAABAnAAAQJwAAAAAAAAAAAAAAAAAAAAAAAAAAAAAAAAAAAAAAAAAAAAAUAAAAAAAAAMDA/wAAAAAAZAAAADIAAAAAAAAAZAAAAAAAAAB/f38ACgAAACIAAAAYAAAAAAAAAAAAAAAAAAAAAAAAAAAAAAAAAAAAJAAAACQAAAAAAAAABwAAAAAAAAAAAAAAAAAAAAAAAAAAAAAAAAAAAH9/fwAlAAAAWAAAAAAAAAAAAAAAAAAAAAAAAAAAAAAAAAAAAAAAAAAAAAAAAAAAAAAAAAAAAAAAPwAAAAAAAACghgEAAAAAAAAAAAAAAAAADAAAAAEAAAAAAAAAAAAAAAAAAAAfAAAAVAAAAEKF9AX///8BAAAAAAAAAAAAAAAAAAAAAAAAAAAAAAAAAAAAAAAAAAAAAAACf39/AFlZWQPMzMwAwMD/AH9/fwAAAAAAAAAAAAAAAAD///8AAAAAACEAAAAYAAAAFAAAAAUDAAB5CwAAQzcAAMkcAAAQAAAAJgAAAAgAAAD//////////w=="/>
               </a:ext>
             </a:extLst>
           </p:cNvPicPr>
@@ -9805,7 +9653,7 @@
             <a:spLocks noGrp="1" noChangeArrowheads="1"/>
             <a:extLst>
               <a:ext uri="smNativeData">
-                <pr:smNativeData xmlns:pr="smNativeData" xmlns="smNativeData" val="SMDATA_15_EkJ5ZhMAAAAlAAAAZAAAAA0AAAAAkAAAAJAAAACQAAAAkAAAAAAAAAAAAAAAAAAAAAEAAABQAAAAAAAAAAAA4D8AAAAAAADgPwAAAAAAAOA/AAAAAAAA4D8AAAAAAADgPwAAAAAAAOA/AAAAAAAA4D8AAAAAAADgPwAAAAAAAOA/AAAAAAAA4D8CAAAAjAAAAAAAAAAAAAAAQoX0DP///wgAAAAAAAAAAAAAAAAAAAAAAAAAAAAAAAAAAAAAZAAAAAEAAABAAAAAAAAAAAAAAAAAAAAAAAAAAAAAAAAAAAAAAAAAAAAAAAAAAAAAAAAAAAAAAAAAAAAAAAAAAAAAAAAAAAAAAAAAAAAAAAAAAAAAAAAAAAAAAAAAAAAAFAAAADwAAAAAAAAAAAAAAAAAAAkUAAAAAQAAABQAAAAUAAAAFAAAAAEAAAAAAAAAZAAAAGQAAAAAAAAAZAAAAGQAAAAVAAAAYAAAAAAAAAAAAAAADwAAACADAAAAAAAAAAAAAAEAAACgMgAAVgcAAKr4//8BAAAAf39/AAEAAABkAAAAAAAAABQAAABAHwAAAAAAACYAAAAAAAAAwOD//wAAAAAmAAAAZAAAABYAAABMAAAAAAAAAAAAAAAEAAAAAAAAAAEAAABZWVkKAAAAACgAAAAoAAAAZAAAAGQAAAAAAAAAzMzMAAAAAABQAAAAUAAAAGQAAABkAAAAAAAAABcAAAAUAAAAAAAAAAAAAAD/fwAA/38AAAAAAAAJAAAABAAAAI+nzTQeAAAAaAAAAAAAAAAAAAAAAAAAAAAAAAAAAAAAECcAABAnAAAAAAAAAAAAAAAAAAAAAAAAAAAAAAAAAAAAAAAAAAAAABQAAAAAAAAAwMD/AAAAAABkAAAAMgAAAAAAAABkAAAAAAAAAH9/fwAKAAAAIgAAABgAAAAAAAAAAAAAAAAAAAAAAAAAAAAAAAAAAAAkAAAAJAAAAAAAAAAHAAAAAAAAAAAAAAAAAAAAAAAAAAAAAAAAAAAAf39/ACUAAABYAAAAAAAAAAAAAAAAAAAAAAAAAAAAAAAAAAAAAAAAAAAAAAAAAAAAAAAAAAAAAAA/AAAAAAAAAKCGAQAAAAAAAAAAAAAAAAAMAAAAAQAAAAAAAAAAAAAAAAAAAB8AAABUAAAAQoX0Bf///wEAAAAAAAAAAAAAAAAAAAAAAAAAAAAAAAAAAAAAAAAAAAAAAAJ/f38AWVlZA8zMzADAwP8Af39/AAAAAAAAAAAAAAAAAAAAAAAAAAAAIQAAABgAAAAUAAAAFAMAALYCAAB/NwAAvwoAABAAAAAmAAAACAAAADwwAAAAAAAA"/>
+                <pr:smNativeData xmlns:pr="smNativeData" xmlns="smNativeData" val="SMDATA_15_LkR5ZhMAAAAlAAAAZAAAAA0AAAAAkAAAAJAAAACQAAAAkAAAAAAAAAAAAAAAAAAAAAEAAABQAAAAAAAAAAAA4D8AAAAAAADgPwAAAAAAAOA/AAAAAAAA4D8AAAAAAADgPwAAAAAAAOA/AAAAAAAA4D8AAAAAAADgPwAAAAAAAOA/AAAAAAAA4D8CAAAAjAAAAAAAAAAAAAAAQoX0DP///wgAAAAAAAAAAAAAAAAAAAAAAAAAAAAAAAAAAAAAZAAAAAEAAABAAAAAAAAAAAAAAAAAAAAAAAAAAAAAAAAAAAAAAAAAAAAAAAAAAAAAAAAAAAAAAAAAAAAAAAAAAAAAAAAAAAAAAAAAAAAAAAAAAAAAAAAAAAAAAAAAAAAAFAAAADwAAAAAAAAAAAAAAAAAAAkUAAAAAQAAABQAAAAUAAAAFAAAAAEAAAAAAAAAZAAAAGQAAAAAAAAAZAAAAGQAAAAVAAAAYAAAAAAAAAAAAAAADwAAACADAAAAAAAAAAAAAAEAAACgMgAAVgcAAKr4//8BAAAAf39/AAEAAABkAAAAAAAAABQAAABAHwAAAAAAACYAAAAAAAAAwOD//wAAAAAmAAAAZAAAABYAAABMAAAAAAAAAAAAAAAEAAAAAAAAAAEAAABZWVkKAAAAACgAAAAoAAAAZAAAAGQAAAAAAAAAzMzMAAAAAABQAAAAUAAAAGQAAABkAAAAAAAAABcAAAAUAAAAAAAAAAAAAAD/fwAA/38AAAAAAAAJAAAABAAAAI+nzTQeAAAAaAAAAAAAAAAAAAAAAAAAAAAAAAAAAAAAECcAABAnAAAAAAAAAAAAAAAAAAAAAAAAAAAAAAAAAAAAAAAAAAAAABQAAAAAAAAAwMD/AAAAAABkAAAAMgAAAAAAAABkAAAAAAAAAH9/fwAKAAAAIgAAABgAAAAAAAAAAAAAAAAAAAAAAAAAAAAAAAAAAAAkAAAAJAAAAAAAAAAHAAAAAAAAAAAAAAAAAAAAAAAAAAAAAAAAAAAAf39/ACUAAABYAAAAAAAAAAAAAAAAAAAAAAAAAAAAAAAAAAAAAAAAAAAAAAAAAAAAAAAAAAAAAAA/AAAAAAAAAKCGAQAAAAAAAAAAAAAAAAAMAAAAAQAAAAAAAAAAAAAAAAAAAB8AAABUAAAAQoX0Bf///wEAAAAAAAAAAAAAAAAAAAAAAAAAAAAAAAAAAAAAAAAAAAAAAAJ/f38AWVlZA8zMzADAwP8Af39/AAAAAAAAAAAAAAAAAAAAAAAAAAAAIQAAABgAAAAUAAAAFAMAALYCAAB/NwAAvwoAABAAAAAmAAAACAAAADwwAAAAAAAA"/>
               </a:ext>
             </a:extLst>
           </p:cNvSpPr>
@@ -9835,6 +9683,7 @@
               <a:rPr lang="ru-ru" cap="none"/>
               <a:t>Выводы и планы по развитию</a:t>
             </a:r>
+            <a:endParaRPr lang="ru-ru" cap="none"/>
           </a:p>
         </p:txBody>
       </p:sp>
@@ -9874,11 +9723,6 @@
                           <a:spcPts val="0"/>
                         </a:spcAft>
                         <a:buNone/>
-                        <a:defRPr cap="none">
-                          <a:solidFill>
-                            <a:srgbClr val="000000"/>
-                          </a:solidFill>
-                        </a:defRPr>
                       </a:pPr>
                       <a:r>
                         <a:rPr lang="ru-ru" sz="1700" b="1" cap="none">
@@ -9949,11 +9793,6 @@
                           <a:spcPts val="0"/>
                         </a:spcAft>
                         <a:buNone/>
-                        <a:defRPr cap="none">
-                          <a:solidFill>
-                            <a:srgbClr val="000000"/>
-                          </a:solidFill>
-                        </a:defRPr>
                       </a:pPr>
                       <a:r>
                         <a:rPr sz="1700" cap="none">
@@ -10004,7 +9843,7 @@
                 </a:tc>
                 <a:extLst>
                   <a:ext uri="smNativeData">
-                    <pr:rowheight xmlns="" xmlns:pr="smNativeData" dt="1719222802" type="min" val="381000"/>
+                    <pr:rowheight xmlns="" xmlns:pr="smNativeData" dt="1719223342" type="min" val="381000"/>
                   </a:ext>
                 </a:extLst>
               </a:tr>
@@ -10022,11 +9861,6 @@
                           <a:spcPts val="0"/>
                         </a:spcAft>
                         <a:buNone/>
-                        <a:defRPr cap="none">
-                          <a:solidFill>
-                            <a:srgbClr val="000000"/>
-                          </a:solidFill>
-                        </a:defRPr>
                       </a:pPr>
                       <a:r>
                         <a:rPr lang="ru-ru" sz="1700" b="1" cap="none">
@@ -10102,11 +9936,6 @@
                           <a:spcPts val="0"/>
                         </a:spcAft>
                         <a:buNone/>
-                        <a:defRPr cap="none">
-                          <a:solidFill>
-                            <a:srgbClr val="000000"/>
-                          </a:solidFill>
-                        </a:defRPr>
                       </a:pPr>
                       <a:r>
                         <a:rPr sz="1700" cap="none">
@@ -10162,7 +9991,7 @@
                 </a:tc>
                 <a:extLst>
                   <a:ext uri="smNativeData">
-                    <pr:rowheight xmlns="" xmlns:pr="smNativeData" dt="1719222802" type="min" val="381000"/>
+                    <pr:rowheight xmlns="" xmlns:pr="smNativeData" dt="1719223342" type="min" val="381000"/>
                   </a:ext>
                 </a:extLst>
               </a:tr>
@@ -10180,11 +10009,6 @@
                           <a:spcPts val="0"/>
                         </a:spcAft>
                         <a:buNone/>
-                        <a:defRPr cap="none">
-                          <a:solidFill>
-                            <a:srgbClr val="000000"/>
-                          </a:solidFill>
-                        </a:defRPr>
                       </a:pPr>
                       <a:r>
                         <a:rPr lang="ru-ru" sz="1700" b="1" cap="none">
@@ -10260,11 +10084,6 @@
                           <a:spcPts val="0"/>
                         </a:spcAft>
                         <a:buNone/>
-                        <a:defRPr cap="none">
-                          <a:solidFill>
-                            <a:srgbClr val="000000"/>
-                          </a:solidFill>
-                        </a:defRPr>
                       </a:pPr>
                       <a:r>
                         <a:rPr sz="1700" cap="none">
@@ -10320,7 +10139,7 @@
                 </a:tc>
                 <a:extLst>
                   <a:ext uri="smNativeData">
-                    <pr:rowheight xmlns="" xmlns:pr="smNativeData" dt="1719222802" type="min" val="381000"/>
+                    <pr:rowheight xmlns="" xmlns:pr="smNativeData" dt="1719223342" type="min" val="381000"/>
                   </a:ext>
                 </a:extLst>
               </a:tr>
@@ -10334,7 +10153,7 @@
           <p:cNvSpPr>
             <a:extLst>
               <a:ext uri="smNativeData">
-                <pr:smNativeData xmlns:pr="smNativeData" xmlns="smNativeData" val="SMDATA_15_EkJ5ZhMAAAAlAAAA9AEAAA0AAAAAOAEAAMYAAAA4AQAAxgAAAAAAAAABAAAAAAAAAAEAAABQAAAAEXC47Anh479Fb0gmzk0BwAAAAAAAAOA/AAAAAAAA4D8AAAAAAADgPwAAAAAAAOA/AAAAAAAA4D8AAAAAAADgPwAAAAAAAOA/AAAAAAAA4D8CAAAAjAAAAAEAAAAAAAAA8/PzAP///wgAAAAAAAAAAAAAAAAAAAAAAAAAAAAAAAAAAAAAeAAAAAEAAABAAAAAAAAAAAAAAABaAAAAAAAAAAAAAAAAAAAAAAAAAAAAAAAAAAAAAAAAAAAAAAAAAAAAAAAAAAAAAAAAAAAAAAAAAAAAAAAAAAAAAAAAAAAAAAAAAAAAFAAAADwAAAABAAAAAAAAAAE9hQAPAAAAAQAAACMAAAAjAAAAIwAAAB4AAAAAAAAASwAAAEsAAAAAAAAASwAAAEsAAAAVAAAAYAAAAAAAAAAAAAAADwAAACADAAAAAAAAAAAAAAEAAACgMgAAVgcAAKr4//8BAAAAf39/AAEAAABkAAAAAAAAABQAAABAHwAAAAAAACYAAAAAAAAAwOD//wAAAAAmAAAAZAAAABYAAABMAAAAAAAAAAAAAAAEAAAAAAAAAAEAAABZWVkKAAAAACgAAAAoAAAAZAAAAGQAAAAAAAAAzMzMAAAAAABQAAAAUAAAAGQAAABkAAAAAAAAABcAAAAUAAAAAAAAAAAAAAD/fwAA/38AAAAAAAAJAAAABAAAADkxY2geAAAAaAAAAAAAAAAAAAAAAAAAAAAAAAAAAAAAECcAABAnAAAAAAAAAAAAAAAAAAAAAAAAAAAAAAAAAAAAAAAAAAAAABQAAAAAAAAAwMD/AAAAAABkAAAAMgAAAAAAAABkAAAAAAAAAH9/fwAKAAAAIgAAABgAAAAAAAAAAAAAAAAAAAAAAAAAAAAAAAAAAAAkAAAAJAAAAAAAAAAHAAAAAAAAAAAAAAAAAAAAAAAAAAAAAAAAAAAAf39/ACUAAABYAAAAAAAAAAAAAAAAAAAAAAAAAAAAAAAAAAAAAAAAAAAAAAAAAAAAAAAAAAAAAAA/AAAAAAAAAKCGAQAAAAAAAAAAAAAAAAAMAAAAAQAAAAAAAAAAAAAAAAAAAB8AAABUAAAA8/PzAP///wEAAAAAAAAAAAAAAAAAAAAAAAAAAAAAAAAAAAAAAAAAAAE9hQB/f38AWVlZA8zMzADAwP8Af39/AAAAAAAAAAAAAAAAAAAAAAAAAAAAIQAAABgAAAAUAAAAVR0AAO0iAABkMgAAMCoAAAAAAAAmAAAACAAAAP//////////"/>
+                <pr:smNativeData xmlns:pr="smNativeData" xmlns="smNativeData" val="SMDATA_15_LkR5ZhMAAAAlAAAA9AEAAA0AAAAAOAEAAMYAAAA4AQAAxgAAAAAAAAABAAAAAAAAAAEAAABQAAAAEXC47Anh479Fb0gmzk0BwAAAAAAAAOA/AAAAAAAA4D8AAAAAAADgPwAAAAAAAOA/AAAAAAAA4D8AAAAAAADgPwAAAAAAAOA/AAAAAAAA4D8CAAAAjAAAAAEAAAAAAAAA8/PzAP///wgAAAAAAAAAAAAAAAAAAAAAAAAAAAAAAAAAAAAAeAAAAAEAAABAAAAAAAAAAAAAAABaAAAAAAAAAAAAAAAAAAAAAAAAAAAAAAAAAAAAAAAAAAAAAAAAAAAAAAAAAAAAAAAAAAAAAAAAAAAAAAAAAAAAAAAAAAAAAAAAAAAAFAAAADwAAAABAAAAAAAAAAE9hQAPAAAAAQAAACMAAAAjAAAAIwAAAB4AAAAAAAAASwAAAEsAAAAAAAAASwAAAEsAAAAVAAAAYAAAAAAAAAAAAAAADwAAACADAAAAAAAAAAAAAAEAAACgMgAAVgcAAKr4//8BAAAAf39/AAEAAABkAAAAAAAAABQAAABAHwAAAAAAACYAAAAAAAAAwOD//wAAAAAmAAAAZAAAABYAAABMAAAAAAAAAAAAAAAEAAAAAAAAAAEAAABZWVkKAAAAACgAAAAoAAAAZAAAAGQAAAAAAAAAzMzMAAAAAABQAAAAUAAAAGQAAABkAAAAAAAAABcAAAAUAAAAAAAAAAAAAAD/fwAA/38AAAAAAAAJAAAABAAAADkxY2geAAAAaAAAAAAAAAAAAAAAAAAAAAAAAAAAAAAAECcAABAnAAAAAAAAAAAAAAAAAAAAAAAAAAAAAAAAAAAAAAAAAAAAABQAAAAAAAAAwMD/AAAAAABkAAAAMgAAAAAAAABkAAAAAAAAAH9/fwAKAAAAIgAAABgAAAAAAAAAAAAAAAAAAAAAAAAAAAAAAAAAAAAkAAAAJAAAAAAAAAAHAAAAAAAAAAAAAAAAAAAAAAAAAAAAAAAAAAAAf39/ACUAAABYAAAAAAAAAAAAAAAAAAAAAAAAAAAAAAAAAAAAAAAAAAAAAAAAAAAAAAAAAAAAAAA/AAAAAAAAAKCGAQAAAAAAAAAAAAAAAAAMAAAAAQAAAAAAAAAAAAAAAAAAAB8AAABUAAAA8/PzAP///wEAAAAAAAAAAAAAAAAAAAAAAAAAAAAAAAAAAAAAAAAAAAE9hQB/f38AWVlZA8zMzADAwP8Af39/AAAAAAAAAAAAAAAAAAAAAAAAAAAAIQAAABgAAAAUAAAAVR0AAO0iAABkMgAAMCoAABAAAAAmAAAACAAAAP//////////"/>
               </a:ext>
             </a:extLst>
           </p:cNvSpPr>
@@ -10438,7 +10257,7 @@
             <a:spLocks noGrp="1" noChangeArrowheads="1"/>
             <a:extLst>
               <a:ext uri="smNativeData">
-                <pr:smNativeData xmlns:pr="smNativeData" xmlns="smNativeData" val="SMDATA_15_EkJ5ZhMAAAAlAAAAZAAAAA0AAAAAkAAAAJAAAACQAAAAkAAAAAAAAAABAAAAAAAAAAEAAABQAAAAAAAAAAAA4D8AAAAAAADgPwAAAAAAAOA/AAAAAAAA4D8AAAAAAADgPwAAAAAAAOA/AAAAAAAA4D8AAAAAAADgPwAAAAAAAOA/AAAAAAAA4D8CAAAAjAAAAAAAAAAAAAAAQoX0DP///wgAAAAAAAAAAAAAAAAAAAAAAAAAAAAAAAAAAAAAZAAAAAEAAABAAAAAAAAAAAAAAAAAAAAAAAAAAAAAAAAAAAAAAAAAAAAAAAAAAAAAAAAAAAAAAAAAAAAAAAAAAAAAAAAAAAAAAAAAAAAAAAAAAAAAAAAAAAAAAAAAAAAAFAAAADwAAAAAAAAAAAAAAAAAAAkUAAAAAQAAABQAAAAUAAAAFAAAAAEAAAAAAAAAZAAAAGQAAAAAAAAAZAAAAGQAAAAVAAAAYAAAAAAAAAAAAAAADwAAACADAAAAAAAAAAAAAAEAAACgMgAAVgcAAKr4//8BAAAAf39/AAEAAABkAAAAAAAAABQAAABAHwAAAAAAACYAAAAAAAAAwOD//wAAAAAmAAAAZAAAABYAAABMAAAAAAAAAAAAAAAEAAAAAAAAAAEAAABZWVkKAAAAACgAAAAoAAAAZAAAAGQAAAAAAAAAzMzMAAAAAABQAAAAUAAAAGQAAABkAAAAAAAAABcAAAAUAAAAAAAAAAAAAAD/fwAA/38AAAAAAAAJAAAABAAAAJx8t8UeAAAAaAAAAAAAAAAAAAAAAAAAAAAAAAAAAAAAECcAABAnAAAAAAAAAAAAAAAAAAAAAAAAAAAAAAAAAAAAAAAAAAAAABQAAAAAAAAAwMD/AAAAAABkAAAAMgAAAAAAAABkAAAAAAAAAH9/fwAKAAAAIgAAABgAAAAAAAAAAAAAAAAAAAAAAAAAAAAAAAAAAAAkAAAAJAAAAAAAAAAHAAAAAAAAAAAAAAAAAAAAAAAAAAAAAAAAAAAAf39/ACUAAABYAAAAAAAAAAAAAAAAAAAAAAAAAAAAAAAAAAAAAAAAAAAAAAAAAAAAAAAAAAAAAAA/AAAAAAAAAKCGAQAAAAAAAAAAAAAAAAAMAAAAAQAAAAAAAAAAAAAAAAAAAB8AAABUAAAAAAAABQAAAAEAAAAAAAAAAAAAAAAAAAAAAAAAAAAAAAAAAAAAAAAAAAAAAAJ/f38AWVlZA8zMzADAwP8Af39/AAAAAAAAAAAAAAAAAAAAAAAAAAAAIQAAABgAAAAUAAAA4gUAAEADAABiNAAAziQAABAAAAAmAAAACAAAAD0wAAAAAAAA"/>
+                <pr:smNativeData xmlns:pr="smNativeData" xmlns="smNativeData" val="SMDATA_15_LkR5ZhMAAAAlAAAAZAAAAA0AAAAAkAAAAJAAAACQAAAAkAAAAAAAAAABAAAAAAAAAAEAAABQAAAAAAAAAAAA4D8AAAAAAADgPwAAAAAAAOA/AAAAAAAA4D8AAAAAAADgPwAAAAAAAOA/AAAAAAAA4D8AAAAAAADgPwAAAAAAAOA/AAAAAAAA4D8CAAAAjAAAAAAAAAAAAAAAQoX0DP///wgAAAAAAAAAAAAAAAAAAAAAAAAAAAAAAAAAAAAAZAAAAAEAAABAAAAAAAAAAAAAAAAAAAAAAAAAAAAAAAAAAAAAAAAAAAAAAAAAAAAAAAAAAAAAAAAAAAAAAAAAAAAAAAAAAAAAAAAAAAAAAAAAAAAAAAAAAAAAAAAAAAAAFAAAADwAAAAAAAAAAAAAAAAAAAkUAAAAAQAAABQAAAAUAAAAFAAAAAEAAAAAAAAAZAAAAGQAAAAAAAAAZAAAAGQAAAAVAAAAYAAAAAAAAAAAAAAADwAAACADAAAAAAAAAAAAAAEAAACgMgAAVgcAAKr4//8BAAAAf39/AAEAAABkAAAAAAAAABQAAABAHwAAAAAAACYAAAAAAAAAwOD//wAAAAAmAAAAZAAAABYAAABMAAAAAAAAAAAAAAAEAAAAAAAAAAEAAABZWVkKAAAAACgAAAAoAAAAZAAAAGQAAAAAAAAAzMzMAAAAAABQAAAAUAAAAGQAAABkAAAAAAAAABcAAAAUAAAAAAAAAAAAAAD/fwAA/38AAAAAAAAJAAAABAAAAJx8t8UeAAAAaAAAAAAAAAAAAAAAAAAAAAAAAAAAAAAAECcAABAnAAAAAAAAAAAAAAAAAAAAAAAAAAAAAAAAAAAAAAAAAAAAABQAAAAAAAAAwMD/AAAAAABkAAAAMgAAAAAAAABkAAAAAAAAAH9/fwAKAAAAIgAAABgAAAAAAAAAAAAAAAAAAAAAAAAAAAAAAAAAAAAkAAAAJAAAAAAAAAAHAAAAAAAAAAAAAAAAAAAAAAAAAAAAAAAAAAAAf39/ACUAAABYAAAAAAAAAAAAAAAAAAAAAAAAAAAAAAAAAAAAAAAAAAAAAAAAAAAAAAAAAAAAAAA/AAAAAAAAAKCGAQAAAAAAAAAAAAAAAAAMAAAAAQAAAAAAAAAAAAAAAAAAAB8AAABUAAAAQoX0Bf///wEAAAAAAAAAAAAAAAAAAAAAAAAAAAAAAAAAAAAAAAAAAAAAAAJ/f38AWVlZA8zMzADAwP8Af39/AAAAAAAAAAAAAAAAAAAAAAAAAAAAIQAAABgAAAAUAAAA4gUAAEADAABiNAAAziQAABAAAAAmAAAACAAAAD0wAAAAAAAA"/>
               </a:ext>
             </a:extLst>
           </p:cNvSpPr>
@@ -10490,181 +10309,6 @@
               </a:spcAft>
               <a:buNone/>
             </a:pPr>
-          </a:p>
-        </p:txBody>
-      </p:sp>
-    </p:spTree>
-  </p:cSld>
-  <p:clrMapOvr>
-    <a:masterClrMapping/>
-  </p:clrMapOvr>
-  <p:timing>
-    <p:tnLst>
-      <p:par>
-        <p:cTn id="1" dur="indefinite" restart="never" nodeType="tmRoot"/>
-      </p:par>
-    </p:tnLst>
-  </p:timing>
-</p:sld>
-</file>
-
-<file path=ppt/slides/slide17.xml><?xml version="1.0" encoding="utf-8"?>
-<p:sld xmlns:p="http://schemas.openxmlformats.org/presentationml/2006/main" xmlns:mc="http://schemas.openxmlformats.org/markup-compatibility/2006" xmlns:p14="http://schemas.microsoft.com/office/powerpoint/2010/main" xmlns:p15="http://schemas.microsoft.com/office/powerpoint/2012/main" xmlns:r="http://schemas.openxmlformats.org/officeDocument/2006/relationships" xmlns:a="http://schemas.openxmlformats.org/drawingml/2006/main" mc:Ignorable="p14">
-  <p:cSld>
-    <p:spTree>
-      <p:nvGrpSpPr>
-        <p:cNvPr id="1" name=""/>
-        <p:cNvGrpSpPr/>
-        <p:nvPr/>
-      </p:nvGrpSpPr>
-      <p:grpSpPr>
-        <a:xfrm>
-          <a:off x="0" y="0"/>
-          <a:ext cx="0" cy="0"/>
-          <a:chOff x="0" y="0"/>
-          <a:chExt cx="0" cy="0"/>
-        </a:xfrm>
-      </p:grpSpPr>
-      <p:sp>
-        <p:nvSpPr>
-          <p:cNvPr id="2" name="Google Shape;392;p48"/>
-          <p:cNvSpPr>
-            <a:spLocks noGrp="1" noChangeArrowheads="1"/>
-            <a:extLst>
-              <a:ext uri="smNativeData">
-                <pr:smNativeData xmlns:pr="smNativeData" xmlns="smNativeData" val="SMDATA_15_EkJ5ZhMAAAAlAAAAZAAAAA0AAAAAkAAAAJAAAACQAAAAkAAAAAAAAAAAAAAAAAAAAAEAAABQAAAAAAAAAAAA4D8AAAAAAADgPwAAAAAAAOA/AAAAAAAA4D8AAAAAAADgPwAAAAAAAOA/AAAAAAAA4D8AAAAAAADgPwAAAAAAAOA/AAAAAAAA4D8CAAAAjAAAAAAAAAAAAAAAQoX0DP///wgAAAAAAAAAAAAAAAAAAAAAAAAAAAAAAAAAAAAAZAAAAAEAAABAAAAAAAAAAAAAAAAAAAAAAAAAAAAAAAAAAAAAAAAAAAAAAAAAAAAAAAAAAAAAAAAAAAAAAAAAAAAAAAAAAAAAAAAAAAAAAAAAAAAAAAAAAAAAAAAAAAAAFAAAADwAAAAAAAAAAAAAAAAAAAkUAAAAAQAAABQAAAAUAAAAFAAAAAEAAAAAAAAAZAAAAGQAAAAAAAAAZAAAAGQAAAAVAAAAYAAAAAAAAAAAAAAADwAAACADAAAAAAAAAAAAAAEAAACgMgAAVgcAAKr4//8BAAAAf39/AAEAAABkAAAAAAAAABQAAABAHwAAAAAAACYAAAAAAAAAwOD//wAAAAAmAAAAZAAAABYAAABMAAAAAAAAAAAAAAAEAAAAAAAAAAEAAABZWVkKAAAAACgAAAAoAAAAZAAAAGQAAAAAAAAAzMzMAAAAAABQAAAAUAAAAGQAAABkAAAAAAAAABcAAAAUAAAAAAAAAAAAAAD/fwAA/38AAAAAAAAJAAAABAAAAAAAAAAeAAAAaAAAAAAAAAAAAAAAAAAAAAAAAAAAAAAAECcAABAnAAAAAAAAAAAAAAAAAAAAAAAAAAAAAAAAAAAAAAAAAAAAABQAAAAAAAAAwMD/AAAAAABkAAAAMgAAAAAAAABkAAAAAAAAAH9/fwAKAAAAIgAAABgAAAAAAAAAAAAAAAAAAAAAAAAAAAAAAAAAAAAkAAAAJAAAAAAAAAAHAAAAAAAAAAAAAAAAAAAAAAAAAAAAAAAAAAAAf39/ACUAAABYAAAAAAAAAAAAAAAAAAAAAAAAAAAAAAAAAAAAAAAAAAAAAAAAAAAAAAAAAAAAAAA/AAAAAAAAAKCGAQAAAAAAAAAAAAAAAAAMAAAAAQAAAAAAAAAAAAAAAAAAAB8AAABUAAAAAAAABQAAAAEAAAAAAAAAAAAAAAAAAAAAAAAAAAAAAAAAAAAAAAAAAAAAAAJ/f38AWVlZA8zMzADAwP8Af39/AAAAAAAAAAAAAAAAAAAAAAAAAAAAIQAAABgAAAAUAAAAFAMAALYCAAB/NwAAvwoAABAAAAAmAAAACAAAADwwAAAAAAAA"/>
-              </a:ext>
-            </a:extLst>
-          </p:cNvSpPr>
-          <p:nvPr>
-            <p:ph type="title"/>
-          </p:nvPr>
-        </p:nvSpPr>
-        <p:spPr/>
-        <p:txBody>
-          <a:bodyPr vert="horz" wrap="square" lIns="91440" tIns="91440" rIns="91440" bIns="91440" numCol="1" spcCol="215900" anchor="t">
-            <a:prstTxWarp prst="textNoShape">
-              <a:avLst/>
-            </a:prstTxWarp>
-          </a:bodyPr>
-          <a:lstStyle/>
-          <a:p>
-            <a:pPr marL="0" indent="0" algn="l">
-              <a:spcBef>
-                <a:spcPts val="0"/>
-              </a:spcBef>
-              <a:spcAft>
-                <a:spcPts val="0"/>
-              </a:spcAft>
-              <a:buNone/>
-            </a:pPr>
-            <a:r>
-              <a:rPr lang="ru-ru" cap="none"/>
-              <a:t>Шаблоны слайдов</a:t>
-            </a:r>
-          </a:p>
-        </p:txBody>
-      </p:sp>
-      <p:pic>
-        <p:nvPicPr>
-          <p:cNvPr id="3" name="Google Shape;393;p48"/>
-          <p:cNvPicPr>
-            <a:extLst>
-              <a:ext uri="smNativeData">
-                <pr:smNativeData xmlns:pr="smNativeData" xmlns="smNativeData" val="SMDATA_17_EkJ5ZhMAAAAlAAAAEQAAAA0AAAAAkAAAAEgAAACQAAAASAAAAAAAAAAAAAAAAAAAAAEAAABQAAAAAAAAAAAA4D8AAAAAAADgPwAAAAAAAOA/AAAAAAAA4D8AAAAAAADgPwAAAAAAAOA/AAAAAAAA4D8AAAAAAADgPwAAAAAAAOA/AAAAAAAA4D8CAAAAjAAAAAAAAAAAAAAAQoX0DP///wgAAAAAAAAAAAAAAAAAAAAAAAAAAAAAAAAAAAAAZAAAAAEAAABAAAAAAAAAAAAAAAAAAAAAAAAAAAAAAAAAAAAAAAAAAAAAAAAAAAAAAAAAAAAAAAAAAAAAAAAAAAAAAAAAAAAAAAAAAAAAAAAAAAAAAAAAAAAAAAAAAAAAFAAAADwAAAABAAAAAAAAAL/B8AAeAAAAAQAAACMAAAAjAAAAIwAAAB4AAAAAAAAASwAAAEsAAAAAAAAASwAAAEsAAAAVAAAAYAAAAAAAAAAAAAAADwAAACADAAAAAAAAAAAAAAEAAACgMgAAVgcAAKr4//8BAAAAf39/AAEAAABkAAAAAAAAABQAAABAHwAAAAAAACYAAAAAAAAAwOD//wAAAAAmAAAAZAAAABYAAABMAAAAAAAAAAAAAAAEAAAAAAAAAAEAAABZWVkKAAAAACgAAAAoAAAAZAAAAGQAAAAAAAAAzMzMAAAAAABQAAAAUAAAAGQAAABkAAAAAAAAAAcAAAA4AAAAAAAAAAAAAAAAAAAA////AAAAAAAAAAAAAAAAAAAAAAAAAAAAAAAAAAAAAABkAAAAZAAAAAAAAAAjAAAABAAAAGQAAAAXAAAAFAAAAAAAAAAAAAAA/38AAP9/AAAAAAAACQAAAAQAAAAAAAAAHgAAAGgAAAAAAAAAAAAAAAAAAAAAAAAAAAAAABAnAAAQJwAAAAAAAAAAAAAAAAAAAAAAAAAAAAAAAAAAAAAAAAAAAAAUAAAAAAAAAMDA/wAAAAAAZAAAADIAAAAAAAAAZAAAAAAAAAB/f38ACgAAACIAAAAYAAAAAAAAAAAAAAAAAAAAAAAAAAAAAAAAAAAAJAAAACQAAAAAAAAABwAAAAAAAAAAAAAAAAAAAAAAAAAAAAAAAAAAAH9/fwAlAAAAWAAAAAAAAAAAAAAAAAAAAAAAAAAAAAAAAAAAAAAAAAAAAAAAAAAAAAAAAAAAAAAAPwAAAAAAAACghgEAAAAAAAAAAAAAAAAADAAAAAEAAAAAAAAAAAAAAAAAAAAfAAAAVAAAAEKF9AX///8BAAAAAAAAAAAAAAAAAAAAAAAAAAAAAAAAAAAAAAAAAAC/wfAAf39/AFlZWQPMzMwAwMD/AH9/fwAAAAAAAAAAAAAAAAD///8AAAAAACEAAAAYAAAAFAAAAD0EAACLDAAA2jEAAAInAAAQAAAAJgAAAAgAAAD//////////w=="/>
-              </a:ext>
-            </a:extLst>
-          </p:cNvPicPr>
-          <p:nvPr/>
-        </p:nvPicPr>
-        <p:blipFill>
-          <a:blip r:embed="rId3"/>
-          <a:stretch>
-            <a:fillRect/>
-          </a:stretch>
-        </p:blipFill>
-        <p:spPr>
-          <a:xfrm>
-            <a:off x="688975" y="2038985"/>
-            <a:ext cx="7414895" cy="4302125"/>
-          </a:xfrm>
-          <a:prstGeom prst="rect">
-            <a:avLst/>
-          </a:prstGeom>
-          <a:noFill/>
-          <a:ln w="19050" cap="flat" cmpd="sng" algn="ctr">
-            <a:solidFill>
-              <a:srgbClr val="BFC1F0"/>
-            </a:solidFill>
-            <a:prstDash val="solid"/>
-            <a:headEnd type="none"/>
-            <a:tailEnd type="none"/>
-          </a:ln>
-          <a:effectLst/>
-        </p:spPr>
-      </p:pic>
-      <p:sp>
-        <p:nvSpPr>
-          <p:cNvPr id="4" name="Google Shape;394;p48"/>
-          <p:cNvSpPr>
-            <a:spLocks noGrp="1" noChangeArrowheads="1"/>
-            <a:extLst>
-              <a:ext uri="smNativeData">
-                <pr:smNativeData xmlns:pr="smNativeData" xmlns="smNativeData" val="SMDATA_15_EkJ5ZhMAAAAlAAAAZAAAAA0AAAAAkAAAAJAAAACQAAAAkAAAAAAAAAAAAAAAAAAAAAEAAABQAAAAAAAAAAAA4D8AAAAAAADgPwAAAAAAAOA/AAAAAAAA4D8AAAAAAADgPwAAAAAAAOA/AAAAAAAA4D8AAAAAAADgPwAAAAAAAOA/AAAAAAAA4D8CAAAAjAAAAAAAAAAAAAAAQoX0DP///wgAAAAAAAAAAAAAAAAAAAAAAAAAAAAAAAAAAAAAZAAAAAEAAABAAAAAAAAAAAAAAAAAAAAAAAAAAAAAAAAAAAAAAAAAAAAAAAAAAAAAAAAAAAAAAAAAAAAAAAAAAAAAAAAAAAAAAAAAAAAAAAAAAAAAAAAAAAAAAAAAAAAAFAAAADwAAAAAAAAAAAAAAAAAAAkUAAAAAQAAABQAAAAUAAAAFAAAAAEAAAAAAAAAZAAAAGQAAAAAAAAAZAAAAGQAAAAVAAAAYAAAAAAAAAAAAAAADwAAACADAAAAAAAAAAAAAAEAAACgMgAAVgcAAKr4//8BAAAAf39/AAEAAABkAAAAAAAAABQAAABAHwAAAAAAACYAAAAAAAAAwOD//wAAAAAmAAAAZAAAABYAAABMAAAAAAAAAAAAAAAEAAAAAAAAAAEAAABZWVkKAAAAACgAAAAoAAAAZAAAAGQAAAAAAAAAzMzMAAAAAABQAAAAUAAAAGQAAABkAAAAAAAAABcAAAAUAAAAAAAAAAAAAAD/fwAA/38AAAAAAAAJAAAABAAAAAAAAAAeAAAAaAAAAAAAAAAAAAAAAAAAAAAAAAAAAAAAECcAABAnAAAAAAAAAAAAAAAAAAAAAAAAAAAAAAAAAAAAAAAAAAAAABQAAAAAAAAAwMD/AAAAAABkAAAAMgAAAAAAAABkAAAAAAAAAH9/fwAKAAAAIgAAABgAAAAAAAAAAAAAAAAAAAAAAAAAAAAAAAAAAAAkAAAAJAAAAAAAAAAHAAAAAAAAAAAAAAAAAAAAAAAAAAAAAAAAAAAAf39/ACUAAABYAAAAAAAAAAAAAAAAAAAAAAAAAAAAAAAAAAAAAAAAAAAAAAAAAAAAAAAAAAAAAAA/AAAAAAAAAKCGAQAAAAAAAAAAAAAAAAAMAAAAAQAAAAAAAAAAAAAAAAAAAB8AAABUAAAAQoX0Bf///wEAAAAAAAAAAAAAAAAAAAAAAAAAAAAAAAAAAAAAAAAAAAAAAAJ/f38AWVlZA8zMzADAwP8Af39/AAAAAAAAAAAAAAAAAAAAAAAAAAAAIQAAABgAAAAUAAAAgwMAANoHAAAgMQAAywsAABAAAAAmAAAACAAAAL+/AAAAAAAA"/>
-              </a:ext>
-            </a:extLst>
-          </p:cNvSpPr>
-          <p:nvPr>
-            <p:ph type="subTitle" idx="4294967295"/>
-          </p:nvPr>
-        </p:nvSpPr>
-        <p:spPr>
-          <a:xfrm>
-            <a:off x="570865" y="1276350"/>
-            <a:ext cx="7414895" cy="640715"/>
-          </a:xfrm>
-          <a:prstGeom prst="rect">
-            <a:avLst/>
-          </a:prstGeom>
-        </p:spPr>
-        <p:txBody>
-          <a:bodyPr vert="horz" wrap="square" lIns="91440" tIns="91440" rIns="91440" bIns="91440" numCol="1" spcCol="215900" anchor="t">
-            <a:prstTxWarp prst="textNoShape">
-              <a:avLst/>
-            </a:prstTxWarp>
-          </a:bodyPr>
-          <a:lstStyle/>
-          <a:p>
-            <a:pPr marL="0" indent="0" algn="l">
-              <a:spcBef>
-                <a:spcPts val="0"/>
-              </a:spcBef>
-              <a:spcAft>
-                <a:spcPts val="0"/>
-              </a:spcAft>
-              <a:buNone/>
-            </a:pPr>
-            <a:r>
-              <a:rPr lang="ru-ru" sz="1200" cap="none"/>
-              <a:t>Чтобы использовать готовые решения слайдов, нужно перейти в пункт меню «Слайд»,</a:t>
-            </a:r>
-            <a:endParaRPr sz="1200" cap="none"/>
-          </a:p>
-          <a:p>
-            <a:pPr marL="0" indent="0" algn="l">
-              <a:spcBef>
-                <a:spcPts val="0"/>
-              </a:spcBef>
-              <a:spcAft>
-                <a:spcPts val="0"/>
-              </a:spcAft>
-              <a:buNone/>
-            </a:pPr>
-            <a:r>
-              <a:rPr lang="ru-ru" sz="1200" cap="none"/>
-              <a:t>далее в выпадающем списке найти подпункт «Выбрать макет». </a:t>
-            </a:r>
-            <a:endParaRPr sz="1200" cap="none"/>
           </a:p>
         </p:txBody>
       </p:sp>
@@ -10706,7 +10350,7 @@
           <p:cNvSpPr>
             <a:extLst>
               <a:ext uri="smNativeData">
-                <pr:smNativeData xmlns:pr="smNativeData" xmlns="smNativeData" val="SMDATA_15_EkJ5ZhMAAAAlAAAAZAAAAA0AAAAAkAAAAJAAAACQAAAAkAAAAAAAAAABAAAAAAAAAAEAAABQAAAAAAAAAAAA4D8AAAAAAADgPwAAAAAAAOA/AAAAAAAA4D8AAAAAAADgPwAAAAAAAOA/AAAAAAAA4D8AAAAAAADgPwAAAAAAAOA/AAAAAAAA4D8CAAAAjAAAAAAAAAAAAAAAQoX0DP///wgAAAAAAAAAAAAAAAAAAAAAAAAAAAAAAAAAAAAAZAAAAAEAAABAAAAAAAAAAAAAAAAAAAAAAAAAAAAAAAAAAAAAAAAAAAAAAAAAAAAAAAAAAAAAAAAAAAAAAAAAAAAAAAAAAAAAAAAAAAAAAAAAAAAAAAAAAAAAAAAAAAAAFAAAADwAAAAAAAAAAAAAAAAAAAkUAAAAAQAAABQAAAAUAAAAFAAAAAEAAAAAAAAAZAAAAGQAAAAAAAAAZAAAAGQAAAAVAAAAYAAAAAAAAAAAAAAADwAAACADAAAAAAAAAAAAAAEAAACgMgAAVgcAAKr4//8BAAAAf39/AAEAAABkAAAAAAAAABQAAABAHwAAAAAAACYAAAAAAAAAwOD//wAAAAAmAAAAZAAAABYAAABMAAAAAAAAAAAAAAAEAAAAAAAAAAEAAABZWVkKAAAAACgAAAAoAAAAZAAAAGQAAAAAAAAAzMzMAAAAAABQAAAAUAAAAGQAAABkAAAAAAAAABcAAAAUAAAAAAAAAAAAAAD/fwAA/38AAAAAAAAJAAAABAAAAF8AYAAeAAAAaAAAAAAAAAAAAAAAAAAAAAAAAAAAAAAAECcAABAnAAAAAAAAAAAAAAAAAAAAAAAAAAAAAAAAAAAAAAAAAAAAABQAAAAAAAAAwMD/AAAAAABkAAAAMgAAAAAAAABkAAAAAAAAAH9/fwAKAAAAIgAAABgAAAAAAAAAAAAAAAAAAAAAAAAAAAAAAAAAAAAkAAAAJAAAAAAAAAAHAAAAAAAAAAAAAAAAAAAAAAAAAAAAAAAAAAAAf39/ACUAAABYAAAAAAAAAAAAAAAAAAAAAAAAAAAAAAAAAAAAAAAAAAAAAAAAAAAAAAAAAAAAAAA/AAAAAAAAAKCGAQAAAAAAAAAAAAAAAAAMAAAAAQAAAAAAAAAAAAAAAAAAAB8AAABUAAAAQoX0Bf///wEAAAAAAAAAAAAAAAAAAAAAAAAAAAAAAAAAAAAAAAAAAAAAAAJ/f38AWVlZA8zMzADAwP8Af39/AAAAAAAAAAAAAAAAAAAAAAAAAAAAIQAAABgAAAAUAAAAtwQAAMgQAACINQAAsBcAABAAAAAmAAAACAAAAP//////////"/>
+                <pr:smNativeData xmlns:pr="smNativeData" xmlns="smNativeData" val="SMDATA_15_LkR5ZhMAAAAlAAAAZAAAAA0AAAAAkAAAAJAAAACQAAAAkAAAAAAAAAABAAAAAAAAAAEAAABQAAAAAAAAAAAA4D8AAAAAAADgPwAAAAAAAOA/AAAAAAAA4D8AAAAAAADgPwAAAAAAAOA/AAAAAAAA4D8AAAAAAADgPwAAAAAAAOA/AAAAAAAA4D8CAAAAjAAAAAAAAAAAAAAAQoX0DP///wgAAAAAAAAAAAAAAAAAAAAAAAAAAAAAAAAAAAAAZAAAAAEAAABAAAAAAAAAAAAAAAAAAAAAAAAAAAAAAAAAAAAAAAAAAAAAAAAAAAAAAAAAAAAAAAAAAAAAAAAAAAAAAAAAAAAAAAAAAAAAAAAAAAAAAAAAAAAAAAAAAAAAFAAAADwAAAAAAAAAAAAAAAAAAAkUAAAAAQAAABQAAAAUAAAAFAAAAAEAAAAAAAAAZAAAAGQAAAAAAAAAZAAAAGQAAAAVAAAAYAAAAAAAAAAAAAAADwAAACADAAAAAAAAAAAAAAEAAACgMgAAVgcAAKr4//8BAAAAf39/AAEAAABkAAAAAAAAABQAAABAHwAAAAAAACYAAAAAAAAAwOD//wAAAAAmAAAAZAAAABYAAABMAAAAAAAAAAAAAAAEAAAAAAAAAAEAAABZWVkKAAAAACgAAAAoAAAAZAAAAGQAAAAAAAAAzMzMAAAAAABQAAAAUAAAAGQAAABkAAAAAAAAABcAAAAUAAAAAAAAAAAAAAD/fwAA/38AAAAAAAAJAAAABAAAAF8AYAAeAAAAaAAAAAAAAAAAAAAAAAAAAAAAAAAAAAAAECcAABAnAAAAAAAAAAAAAAAAAAAAAAAAAAAAAAAAAAAAAAAAAAAAABQAAAAAAAAAwMD/AAAAAABkAAAAMgAAAAAAAABkAAAAAAAAAH9/fwAKAAAAIgAAABgAAAAAAAAAAAAAAAAAAAAAAAAAAAAAAAAAAAAkAAAAJAAAAAAAAAAHAAAAAAAAAAAAAAAAAAAAAAAAAAAAAAAAAAAAf39/ACUAAABYAAAAAAAAAAAAAAAAAAAAAAAAAAAAAAAAAAAAAAAAAAAAAAAAAAAAAAAAAAAAAAA/AAAAAAAAAKCGAQAAAAAAAAAAAAAAAAAMAAAAAQAAAAAAAAAAAAAAAAAAAB8AAABUAAAAQoX0Bf///wEAAAAAAAAAAAAAAAAAAAAAAAAAAAAAAAAAAAAAAAAAAAAAAAJ/f38AWVlZA8zMzADAwP8Af39/AAAAAAAAAAAAAAAAAAAAAAAAAAAAIQAAABgAAAAUAAAAtwQAAMgQAACINQAAsBcAABAAAAAmAAAACAAAAP//////////"/>
               </a:ext>
             </a:extLst>
           </p:cNvSpPr>
@@ -10785,7 +10429,7 @@
           <p:cNvPicPr>
             <a:extLst>
               <a:ext uri="smNativeData">
-                <pr:smNativeData xmlns:pr="smNativeData" xmlns="smNativeData" val="SMDATA_17_EkJ5ZhMAAAAlAAAAEQAAAA0AAAAAkAAAAEgAAACQAAAASAAAAAAAAAAAAAAAAAAAAAEAAABQAAAAAAAAAAAA4D8AAAAAAADgPwAAAAAAAOA/AAAAAAAA4D8AAAAAAADgPwAAAAAAAOA/AAAAAAAA4D8AAAAAAADgPwAAAAAAAOA/AAAAAAAA4D8CAAAAjAAAAAAAAAAAAAAAQoX0DP///wgAAAAAAAAAAAAAAAAAAAAAAAAAAAAAAAAAAAAAZAAAAAEAAABAAAAAAAAAAAAAAAAAAAAAAAAAAAAAAAAAAAAAAAAAAAAAAAAAAAAAAAAAAAAAAAAAAAAAAAAAAAAAAAAAAAAAAAAAAAAAAAAAAAAAAAAAAAAAAAAAAAAAFAAAADwAAAAAAAAAAAAAAAAAAAkUAAAAAQAAABQAAAAUAAAAFAAAAAEAAAAAAAAAZAAAAGQAAAAAAAAAZAAAAGQAAAAVAAAAYAAAAAAAAAAAAAAADwAAACADAAAAAAAAAAAAAAEAAACgMgAAVgcAAKr4//8BAAAAf39/AAEAAABkAAAAAAAAABQAAABAHwAAAAAAACYAAAAAAAAAwOD//wAAAAAmAAAAZAAAABYAAABMAAAAAAAAAAAAAAAEAAAAAAAAAAEAAABZWVkKAAAAACgAAAAoAAAAZAAAAGQAAAAAAAAAzMzMAAAAAABQAAAAUAAAAGQAAABkAAAAAAAAAAcAAAA4AAAAAAAAAAAAAAAAAAAA////AAAAAAAAAAAAAAAAAAAAAAAAAAAAAAAAAAAAAABkAAAAZAAAAAAAAAAjAAAABAAAAGQAAAAXAAAAFAAAAAAAAAAAAAAA/38AAP9/AAAAAAAACQAAAAQAAAAAAAAAHgAAAGgAAAAAAAAAAAAAAAAAAAAAAAAAAAAAABAnAAAQJwAAAAAAAAAAAAAAAAAAAAAAAAAAAAAAAAAAAAAAAAAAAAAUAAAAAAAAAMDA/wAAAAAAZAAAADIAAAAAAAAAZAAAAAAAAAB/f38ACgAAACIAAAAYAAAAAAAAAAAAAAAAAAAAAAAAAAAAAAAAAAAAJAAAACQAAAAAAAAABwAAAAAAAAAAAAAAAAAAAAAAAAAAAAAAAAAAAH9/fwAlAAAAWAAAAAAAAAAAAAAAAAAAAAAAAAAAAAAAAAAAAAAAAAAAAAAAAAAAAAAAAAAAAAAAPwAAAAAAAACghgEAAAAAAAAAAAAAAAAADAAAAAEAAAAAAAAAAAAAAAAAAAAfAAAAVAAAAEKF9AX///8BAAAAAAAAAAAAAAAAAAAAAAAAAAAAAAAAAAAAAAAAAAAAAAACf39/AFlZWQPMzMwAwMD/AH9/fwAAAAAAAAAAAAAAAAD///8AAAAAACEAAAAYAAAAFAAAAEYFAAD3GgAAmAkAAEkfAAAQAAAAJgAAAAgAAAD//////////w=="/>
+                <pr:smNativeData xmlns:pr="smNativeData" xmlns="smNativeData" val="SMDATA_17_LkR5ZhMAAAAlAAAAEQAAAA0AAAAAkAAAAEgAAACQAAAASAAAAAAAAAAAAAAAAAAAAAEAAABQAAAAAAAAAAAA4D8AAAAAAADgPwAAAAAAAOA/AAAAAAAA4D8AAAAAAADgPwAAAAAAAOA/AAAAAAAA4D8AAAAAAADgPwAAAAAAAOA/AAAAAAAA4D8CAAAAjAAAAAAAAAAAAAAAQoX0DP///wgAAAAAAAAAAAAAAAAAAAAAAAAAAAAAAAAAAAAAZAAAAAEAAABAAAAAAAAAAAAAAAAAAAAAAAAAAAAAAAAAAAAAAAAAAAAAAAAAAAAAAAAAAAAAAAAAAAAAAAAAAAAAAAAAAAAAAAAAAAAAAAAAAAAAAAAAAAAAAAAAAAAAFAAAADwAAAAAAAAAAAAAAAAAAAkUAAAAAQAAABQAAAAUAAAAFAAAAAEAAAAAAAAAZAAAAGQAAAAAAAAAZAAAAGQAAAAVAAAAYAAAAAAAAAAAAAAADwAAACADAAAAAAAAAAAAAAEAAACgMgAAVgcAAKr4//8BAAAAf39/AAEAAABkAAAAAAAAABQAAABAHwAAAAAAACYAAAAAAAAAwOD//wAAAAAmAAAAZAAAABYAAABMAAAAAAAAAAAAAAAEAAAAAAAAAAEAAABZWVkKAAAAACgAAAAoAAAAZAAAAGQAAAAAAAAAzMzMAAAAAABQAAAAUAAAAGQAAABkAAAAAAAAAAcAAAA4AAAAAAAAAAAAAAAAAAAA////AAAAAAAAAAAAAAAAAAAAAAAAAAAAAAAAAAAAAABkAAAAZAAAAAAAAAAjAAAABAAAAGQAAAAXAAAAFAAAAAAAAAAAAAAA/38AAP9/AAAAAAAACQAAAAQAAAAAAAAAHgAAAGgAAAAAAAAAAAAAAAAAAAAAAAAAAAAAABAnAAAQJwAAAAAAAAAAAAAAAAAAAAAAAAAAAAAAAAAAAAAAAAAAAAAUAAAAAAAAAMDA/wAAAAAAZAAAADIAAAAAAAAAZAAAAAAAAAB/f38ACgAAACIAAAAYAAAAAAAAAAAAAAAAAAAAAAAAAAAAAAAAAAAAJAAAACQAAAAAAAAABwAAAAAAAAAAAAAAAAAAAAAAAAAAAAAAAAAAAH9/fwAlAAAAWAAAAAAAAAAAAAAAAAAAAAAAAAAAAAAAAAAAAAAAAAAAAAAAAAAAAAAAAAAAAAAAPwAAAAAAAACghgEAAAAAAAAAAAAAAAAADAAAAAEAAAAAAAAAAAAAAAAAAAAfAAAAVAAAAEKF9AX///8BAAAAAAAAAAAAAAAAAAAAAAAAAAAAAAAAAAAAAAAAAAAAAAACf39/AFlZWQPMzMwAwMD/AH9/fwAAAAAAAAAAAAAAAAD///8AAAAAACEAAAAYAAAAFAAAAEYFAAD3GgAAmAkAAEkfAAAQAAAAJgAAAAgAAAD//////////w=="/>
               </a:ext>
             </a:extLst>
           </p:cNvPicPr>
@@ -10818,7 +10462,7 @@
           <p:cNvPicPr>
             <a:extLst>
               <a:ext uri="smNativeData">
-                <pr:smNativeData xmlns:pr="smNativeData" xmlns="smNativeData" val="SMDATA_17_EkJ5ZhMAAAAlAAAAEQAAAA0AAAAAkAAAAEgAAACQAAAASAAAAAAAAAAAAAAAAAAAAAEAAABQAAAAAAAAAAAA4D8AAAAAAADgPwAAAAAAAOA/AAAAAAAA4D8AAAAAAADgPwAAAAAAAOA/AAAAAAAA4D8AAAAAAADgPwAAAAAAAOA/AAAAAAAA4D8CAAAAjAAAAAAAAAAAAAAAQoX0DP///wgAAAAAAAAAAAAAAAAAAAAAAAAAAAAAAAAAAAAAZAAAAAEAAABAAAAAAAAAAAAAAAAAAAAAAAAAAAAAAAAAAAAAAAAAAAAAAAAAAAAAAAAAAAAAAAAAAAAAAAAAAAAAAAAAAAAAAAAAAAAAAAAAAAAAAAAAAAAAAAAAAAAAFAAAADwAAAAAAAAAAAAAAAAAAAkUAAAAAQAAABQAAAAUAAAAFAAAAAEAAAAAAAAAZAAAAGQAAAAAAAAAZAAAAGQAAAAVAAAAYAAAAAAAAAAAAAAADwAAACADAAAAAAAAAAAAAAEAAACgMgAAVgcAAKr4//8BAAAAf39/AAEAAABkAAAAAAAAABQAAABAHwAAAAAAACYAAAAAAAAAwOD//wAAAAAmAAAAZAAAABYAAABMAAAAAAAAAAAAAAAEAAAAAAAAAAEAAABZWVkKAAAAACgAAAAoAAAAZAAAAGQAAAAAAAAAzMzMAAAAAABQAAAAUAAAAGQAAABkAAAAAAAAAAcAAAA4AAAAAAAAAAAAAAAAAAAA////AAAAAAAAAAAAAAAAAAAAAAAAAAAAAAAAAAAAAABkAAAAZAAAAAAAAAAjAAAABAAAAGQAAAAXAAAAFAAAAAAAAAAAAAAA/38AAP9/AAAAAAAACQAAAAQAAADPAQAAHgAAAGgAAAAAAAAAAAAAAAAAAAAAAAAAAAAAABAnAAAQJwAAAAAAAAAAAAAAAAAAAAAAAAAAAAAAAAAAAAAAAAAAAAAUAAAAAAAAAMDA/wAAAAAAZAAAADIAAAAAAAAAZAAAAAAAAAB/f38ACgAAACIAAAAYAAAAAAAAAAAAAAAAAAAAAAAAAAAAAAAAAAAAJAAAACQAAAAAAAAABwAAAAAAAAAAAAAAAAAAAAAAAAAAAAAAAAAAAH9/fwAlAAAAWAAAAAAAAAAAAAAAAAAAAAAAAAAAAAAAAAAAAAAAAAAAAAAAAAAAAAAAAAAAAAAAPwAAAAAAAACghgEAAAAAAAAAAAAAAAAADAAAAAEAAAAAAAAAAAAAAAAAAAAfAAAAVAAAAEKF9AX///8BAAAAAAAAAAAAAAAAAAAAAAAAAAAAAAAAAAAAAAAAAAAAAAACf39/AFlZWQPMzMwAwMD/AH9/fwAAAAAAAAAAAAAAAAD///8AAAAAACEAAAAYAAAAFAAAALAKAAD3GgAAAg8AAEkfAAAQAAAAJgAAAAgAAAD//////////w=="/>
+                <pr:smNativeData xmlns:pr="smNativeData" xmlns="smNativeData" val="SMDATA_17_LkR5ZhMAAAAlAAAAEQAAAA0AAAAAkAAAAEgAAACQAAAASAAAAAAAAAAAAAAAAAAAAAEAAABQAAAAAAAAAAAA4D8AAAAAAADgPwAAAAAAAOA/AAAAAAAA4D8AAAAAAADgPwAAAAAAAOA/AAAAAAAA4D8AAAAAAADgPwAAAAAAAOA/AAAAAAAA4D8CAAAAjAAAAAAAAAAAAAAAQoX0DP///wgAAAAAAAAAAAAAAAAAAAAAAAAAAAAAAAAAAAAAZAAAAAEAAABAAAAAAAAAAAAAAAAAAAAAAAAAAAAAAAAAAAAAAAAAAAAAAAAAAAAAAAAAAAAAAAAAAAAAAAAAAAAAAAAAAAAAAAAAAAAAAAAAAAAAAAAAAAAAAAAAAAAAFAAAADwAAAAAAAAAAAAAAAAAAAkUAAAAAQAAABQAAAAUAAAAFAAAAAEAAAAAAAAAZAAAAGQAAAAAAAAAZAAAAGQAAAAVAAAAYAAAAAAAAAAAAAAADwAAACADAAAAAAAAAAAAAAEAAACgMgAAVgcAAKr4//8BAAAAf39/AAEAAABkAAAAAAAAABQAAABAHwAAAAAAACYAAAAAAAAAwOD//wAAAAAmAAAAZAAAABYAAABMAAAAAAAAAAAAAAAEAAAAAAAAAAEAAABZWVkKAAAAACgAAAAoAAAAZAAAAGQAAAAAAAAAzMzMAAAAAABQAAAAUAAAAGQAAABkAAAAAAAAAAcAAAA4AAAAAAAAAAAAAAAAAAAA////AAAAAAAAAAAAAAAAAAAAAAAAAAAAAAAAAAAAAABkAAAAZAAAAAAAAAAjAAAABAAAAGQAAAAXAAAAFAAAAAAAAAAAAAAA/38AAP9/AAAAAAAACQAAAAQAAADPAQAAHgAAAGgAAAAAAAAAAAAAAAAAAAAAAAAAAAAAABAnAAAQJwAAAAAAAAAAAAAAAAAAAAAAAAAAAAAAAAAAAAAAAAAAAAAUAAAAAAAAAMDA/wAAAAAAZAAAADIAAAAAAAAAZAAAAAAAAAB/f38ACgAAACIAAAAYAAAAAAAAAAAAAAAAAAAAAAAAAAAAAAAAAAAAJAAAACQAAAAAAAAABwAAAAAAAAAAAAAAAAAAAAAAAAAAAAAAAAAAAH9/fwAlAAAAWAAAAAAAAAAAAAAAAAAAAAAAAAAAAAAAAAAAAAAAAAAAAAAAAAAAAAAAAAAAAAAAPwAAAAAAAACghgEAAAAAAAAAAAAAAAAADAAAAAEAAAAAAAAAAAAAAAAAAAAfAAAAVAAAAEKF9AX///8BAAAAAAAAAAAAAAAAAAAAAAAAAAAAAAAAAAAAAAAAAAAAAAACf39/AFlZWQPMzMwAwMD/AH9/fwAAAAAAAAAAAAAAAAD///8AAAAAACEAAAAYAAAAFAAAALAKAAD3GgAAAg8AAEkfAAAQAAAAJgAAAAgAAAD//////////w=="/>
               </a:ext>
             </a:extLst>
           </p:cNvPicPr>
@@ -10883,7 +10527,7 @@
           <p:cNvSpPr>
             <a:extLst>
               <a:ext uri="smNativeData">
-                <pr:smNativeData xmlns:pr="smNativeData" xmlns="smNativeData" val="SMDATA_15_EkJ5ZhMAAAAlAAAAZAAAAA0AAAAAkAAAAJAAAACQAAAAkAAAAAAAAAABAAAAAAAAAAEAAABQAAAAAAAAAAAA4D8AAAAAAADgPwAAAAAAAOA/AAAAAAAA4D8AAAAAAADgPwAAAAAAAOA/AAAAAAAA4D8AAAAAAADgPwAAAAAAAOA/AAAAAAAA4D8CAAAAjAAAAAEAAAAAAAAAAT2FAP///wgAAAAAAAAAAAAAAAAAAAAAAAAAAAAAAAAAAAAAeAAAAAEAAABAAAAAAAAAAAAAAABaAAAAAAAAAAAAAAAAAAAAAAAAAAAAAAAAAAAAAAAAAAAAAAAAAAAAAAAAAAAAAAAAAAAAAAAAAAAAAAAAAAAAAAAAAAAAAAAAAAAAFAAAADwAAAAAAAAAAAAAAAAAAAkUAAAAAQAAABQAAAAUAAAAFAAAAAEAAAAAAAAAZAAAAGQAAAAAAAAAZAAAAGQAAAAVAAAAYAAAAAAAAAAAAAAADwAAACADAAAAAAAAAAAAAAEAAACgMgAAVgcAAKr4//8BAAAAf39/AAEAAABkAAAAAAAAABQAAABAHwAAAAAAACYAAAAAAAAAwOD//wAAAAAmAAAAZAAAABYAAABMAAAAAAAAAAAAAAAEAAAAAAAAAAEAAABZWVkKAAAAACgAAAAoAAAAZAAAAGQAAAAAAAAAzMzMAAAAAABQAAAAUAAAAGQAAABkAAAAAAAAABcAAAAUAAAAAAAAAAAAAAD/fwAA/38AAAAAAAAJAAAABAAAAF8AYAAeAAAAaAAAAAAAAAAAAAAAAAAAAAAAAAAAAAAAECcAABAnAAAAAAAAAAAAAAAAAAAAAAAAAAAAAAAAAAAAAAAAAAAAABQAAAAAAAAAwMD/AAAAAABkAAAAMgAAAAAAAABkAAAAAAAAAH9/fwAKAAAAIgAAABgAAAAAAAAAAAAAAAAAAAAAAAAAAAAAAAAAAAAkAAAAJAAAAAAAAAAHAAAAAAAAAAAAAAAAAAAAAAAAAAAAAAAAAAAAf39/ACUAAABYAAAAAAAAAAAAAAAAAAAAAAAAAAAAAAAAAAAAAAAAAAAAAAAAAAAAAAAAAAAAAAA/AAAAAAAAAKCGAQAAAAAAAAAAAAAAAAAMAAAAAQAAAAAAAAAAAAAAAAAAAB8AAABUAAAAAT2FAP///wEAAAAAAAAAAAAAAAAAAAAAAAAAAAAAAAAAAAAAAAAAAAAAAAJ/f38AWVlZA8zMzADAwP8Af39/AAAAAAAAAAAAAAAAAAAAAAAAAAAAIQAAABgAAAAUAAAA4AMAALMWAAAyDQAAniUAABAAAAAmAAAACAAAAP//////////"/>
+                <pr:smNativeData xmlns:pr="smNativeData" xmlns="smNativeData" val="SMDATA_15_LkR5ZhMAAAAlAAAAZAAAAA0AAAAAkAAAAJAAAACQAAAAkAAAAAAAAAABAAAAAAAAAAEAAABQAAAAAAAAAAAA4D8AAAAAAADgPwAAAAAAAOA/AAAAAAAA4D8AAAAAAADgPwAAAAAAAOA/AAAAAAAA4D8AAAAAAADgPwAAAAAAAOA/AAAAAAAA4D8CAAAAjAAAAAEAAAAAAAAAAT2FAP///wgAAAAAAAAAAAAAAAAAAAAAAAAAAAAAAAAAAAAAeAAAAAEAAABAAAAAAAAAAAAAAABaAAAAAAAAAAAAAAAAAAAAAAAAAAAAAAAAAAAAAAAAAAAAAAAAAAAAAAAAAAAAAAAAAAAAAAAAAAAAAAAAAAAAAAAAAAAAAAAAAAAAFAAAADwAAAAAAAAAAAAAAAAAAAkUAAAAAQAAABQAAAAUAAAAFAAAAAEAAAAAAAAAZAAAAGQAAAAAAAAAZAAAAGQAAAAVAAAAYAAAAAAAAAAAAAAADwAAACADAAAAAAAAAAAAAAEAAACgMgAAVgcAAKr4//8BAAAAf39/AAEAAABkAAAAAAAAABQAAABAHwAAAAAAACYAAAAAAAAAwOD//wAAAAAmAAAAZAAAABYAAABMAAAAAAAAAAAAAAAEAAAAAAAAAAEAAABZWVkKAAAAACgAAAAoAAAAZAAAAGQAAAAAAAAAzMzMAAAAAABQAAAAUAAAAGQAAABkAAAAAAAAABcAAAAUAAAAAAAAAAAAAAD/fwAA/38AAAAAAAAJAAAABAAAAF8AYAAeAAAAaAAAAAAAAAAAAAAAAAAAAAAAAAAAAAAAECcAABAnAAAAAAAAAAAAAAAAAAAAAAAAAAAAAAAAAAAAAAAAAAAAABQAAAAAAAAAwMD/AAAAAABkAAAAMgAAAAAAAABkAAAAAAAAAH9/fwAKAAAAIgAAABgAAAAAAAAAAAAAAAAAAAAAAAAAAAAAAAAAAAAkAAAAJAAAAAAAAAAHAAAAAAAAAAAAAAAAAAAAAAAAAAAAAAAAAAAAf39/ACUAAABYAAAAAAAAAAAAAAAAAAAAAAAAAAAAAAAAAAAAAAAAAAAAAAAAAAAAAAAAAAAAAAA/AAAAAAAAAKCGAQAAAAAAAAAAAAAAAAAMAAAAAQAAAAAAAAAAAAAAAAAAAB8AAABUAAAAAT2FAP///wEAAAAAAAAAAAAAAAAAAAAAAAAAAAAAAAAAAAAAAAAAAAAAAAJ/f38AWVlZA8zMzADAwP8Af39/AAAAAAAAAAAAAAAAAAAAAAAAAAAAIQAAABgAAAAUAAAA4AMAALMWAAAyDQAAniUAABAAAAAmAAAACAAAAP//////////"/>
               </a:ext>
             </a:extLst>
           </p:cNvSpPr>
@@ -10928,7 +10572,7 @@
             <a:spLocks noGrp="1" noChangeArrowheads="1"/>
             <a:extLst>
               <a:ext uri="smNativeData">
-                <pr:smNativeData xmlns:pr="smNativeData" xmlns="smNativeData" val="SMDATA_15_EkJ5ZhMAAAAlAAAAZAAAAA0AAAAAkAAAAJAAAACQAAAAkAAAAAAAAAAAAAAAAAAAAAEAAABQAAAAAAAAAAAA4D8AAAAAAADgPwAAAAAAAOA/AAAAAAAA4D8AAAAAAADgPwAAAAAAAOA/AAAAAAAA4D8AAAAAAADgPwAAAAAAAOA/AAAAAAAA4D8CAAAAjAAAAAAAAAAAAAAAQoX0DP///wgAAAAAAAAAAAAAAAAAAAAAAAAAAAAAAAAAAAAAZAAAAAEAAABAAAAAAAAAAAAAAAAAAAAAAAAAAAAAAAAAAAAAAAAAAAAAAAAAAAAAAAAAAAAAAAAAAAAAAAAAAAAAAAAAAAAAAAAAAAAAAAAAAAAAAAAAAAAAAAAAAAAAFAAAADwAAAAAAAAAAAAAAAAAAAkUAAAAAQAAABQAAAAUAAAAFAAAAAEAAAAAAAAAZAAAAGQAAAAAAAAAZAAAAGQAAAAVAAAAYAAAAAAAAAAAAAAADwAAACADAAAAAAAAAAAAAAEAAACgMgAAVgcAAKr4//8BAAAAf39/AAEAAABkAAAAAAAAABQAAABAHwAAAAAAACYAAAAAAAAAwOD//wAAAAAmAAAAZAAAABYAAABMAAAAAAAAAAAAAAAEAAAAAAAAAAEAAABZWVkKAAAAACgAAAAoAAAAZAAAAGQAAAAAAAAAzMzMAAAAAABQAAAAUAAAAGQAAABkAAAAAAAAABcAAAAUAAAAAAAAAAAAAAD/fwAA/38AAAAAAAAJAAAABAAAAJrHIpceAAAAaAAAAAAAAAAAAAAAAAAAAAAAAAAAAAAAECcAABAnAAAAAAAAAAAAAAAAAAAAAAAAAAAAAAAAAAAAAAAAAAAAABQAAAAAAAAAwMD/AAAAAABkAAAAMgAAAAAAAABkAAAAAAAAAH9/fwAKAAAAIgAAABgAAAAAAAAAAAAAAAAAAAAAAAAAAAAAAAAAAAAkAAAAJAAAAAAAAAAHAAAAAAAAAAAAAAAAAAAAAAAAAAAAAAAAAAAAf39/ACUAAABYAAAAAAAAAAAAAAAAAAAAAAAAAAAAAAAAAAAAAAAAAAAAAAAAAAAAAAAAAAAAAAA/AAAAAAAAAKCGAQAAAAAAAAAAAAAAAAAMAAAAAQAAAAAAAAAAAAAAAAAAAB8AAABUAAAAAAAABQAAAAEAAAAAAAAAAAAAAAAAAAAAAAAAAAAAAAAAAAAAAAAAAAAAAAJ/f38AWVlZA8zMzADAwP8Af39/AAAAAAAAAAAAAAAAAAAAAAAAAAAAIQAAABgAAAAUAAAAFAMAALwGAAB/NwAAARcAAAAAAAAmAAAACAAAAD0wAAAAAAAA"/>
+                <pr:smNativeData xmlns:pr="smNativeData" xmlns="smNativeData" val="SMDATA_15_LkR5ZhMAAAAlAAAAZAAAAA0AAAAAkAAAAJAAAACQAAAAkAAAAAAAAAAAAAAAAAAAAAEAAABQAAAAAAAAAAAA4D8AAAAAAADgPwAAAAAAAOA/AAAAAAAA4D8AAAAAAADgPwAAAAAAAOA/AAAAAAAA4D8AAAAAAADgPwAAAAAAAOA/AAAAAAAA4D8CAAAAjAAAAAAAAAAAAAAAQoX0DP///wgAAAAAAAAAAAAAAAAAAAAAAAAAAAAAAAAAAAAAZAAAAAEAAABAAAAAAAAAAAAAAAAAAAAAAAAAAAAAAAAAAAAAAAAAAAAAAAAAAAAAAAAAAAAAAAAAAAAAAAAAAAAAAAAAAAAAAAAAAAAAAAAAAAAAAAAAAAAAAAAAAAAAFAAAADwAAAAAAAAAAAAAAAAAAAkUAAAAAQAAABQAAAAUAAAAFAAAAAEAAAAAAAAAZAAAAGQAAAAAAAAAZAAAAGQAAAAVAAAAYAAAAAAAAAAAAAAADwAAACADAAAAAAAAAAAAAAEAAACgMgAAVgcAAKr4//8BAAAAf39/AAEAAABkAAAAAAAAABQAAABAHwAAAAAAACYAAAAAAAAAwOD//wAAAAAmAAAAZAAAABYAAABMAAAAAAAAAAAAAAAEAAAAAAAAAAEAAABZWVkKAAAAACgAAAAoAAAAZAAAAGQAAAAAAAAAzMzMAAAAAABQAAAAUAAAAGQAAABkAAAAAAAAABcAAAAUAAAAAAAAAAAAAAD/fwAA/38AAAAAAAAJAAAABAAAAJrHIpceAAAAaAAAAAAAAAAAAAAAAAAAAAAAAAAAAAAAECcAABAnAAAAAAAAAAAAAAAAAAAAAAAAAAAAAAAAAAAAAAAAAAAAABQAAAAAAAAAwMD/AAAAAABkAAAAMgAAAAAAAABkAAAAAAAAAH9/fwAKAAAAIgAAABgAAAAAAAAAAAAAAAAAAAAAAAAAAAAAAAAAAAAkAAAAJAAAAAAAAAAHAAAAAAAAAAAAAAAAAAAAAAAAAAAAAAAAAAAAf39/ACUAAABYAAAAAAAAAAAAAAAAAAAAAAAAAAAAAAAAAAAAAAAAAAAAAAAAAAAAAAAAAAAAAAA/AAAAAAAAAKCGAQAAAAAAAAAAAAAAAAAMAAAAAQAAAAAAAAAAAAAAAAAAAB8AAABUAAAAQoX0Bf///wEAAAAAAAAAAAAAAAAAAAAAAAAAAAAAAAAAAAAAAAAAAAAAAAJ/f38AWVlZA8zMzADAwP8Af39/AAAAAAAAAAAAAAAAAAAAAAAAAAAAIQAAABgAAAAUAAAAFAMAAFQEAAB/NwAAARcAABAAAAAmAAAACAAAAD0wAAAAAAAA"/>
               </a:ext>
             </a:extLst>
           </p:cNvSpPr>
@@ -10938,8 +10582,8 @@
         </p:nvSpPr>
         <p:spPr>
           <a:xfrm>
-            <a:off x="500380" y="1094740"/>
-            <a:ext cx="8521065" cy="2644775"/>
+            <a:off x="500380" y="703580"/>
+            <a:ext cx="8521065" cy="3035935"/>
           </a:xfrm>
         </p:spPr>
         <p:txBody>
@@ -10963,6 +10607,7 @@
               <a:rPr lang="ru-ru" cap="none"/>
               <a:t>Защита проекта</a:t>
             </a:r>
+            <a:endParaRPr lang="ru-ru" cap="none"/>
           </a:p>
           <a:p>
             <a:pPr marL="0" indent="0" algn="l">
@@ -10986,6 +10631,11 @@
               </a:rPr>
               <a:t>Микросервис на основе Apache Kafka для обогащения данных из внешнего источника с помощью ZIO</a:t>
             </a:r>
+            <a:endParaRPr cap="none">
+              <a:solidFill>
+                <a:srgbClr val="0000FF"/>
+              </a:solidFill>
+            </a:endParaRPr>
           </a:p>
           <a:p>
             <a:pPr marL="0" indent="0" algn="l">
@@ -11007,7 +10657,7 @@
             <a:spLocks noGrp="1" noChangeArrowheads="1"/>
             <a:extLst>
               <a:ext uri="smNativeData">
-                <pr:smNativeData xmlns:pr="smNativeData" xmlns="smNativeData" val="SMDATA_15_EkJ5ZhMAAAAlAAAAZAAAAA0AAAAAkAAAAJAAAACQAAAAkAAAAAAAAAAAAAAAAAAAAAEAAABQAAAAAAAAAAAA4D8AAAAAAADgPwAAAAAAAOA/AAAAAAAA4D8AAAAAAADgPwAAAAAAAOA/AAAAAAAA4D8AAAAAAADgPwAAAAAAAOA/AAAAAAAA4D8CAAAAjAAAAAAAAAAAAAAAQoX0DP///wgAAAAAAAAAAAAAAAAAAAAAAAAAAAAAAAAAAAAAZAAAAAEAAABAAAAAAAAAAAAAAAAAAAAAAAAAAAAAAAAAAAAAAAAAAAAAAAAAAAAAAAAAAAAAAAAAAAAAAAAAAAAAAAAAAAAAAAAAAAAAAAAAAAAAAAAAAAAAAAAAAAAAFAAAADwAAAAAAAAAAAAAAAAAAAkUAAAAAQAAABQAAAAUAAAAFAAAAAEAAAAAAAAAZAAAAGQAAAAAAAAAZAAAAGQAAAAVAAAAYAAAAAAAAAAAAAAADwAAACADAAAAAAAAAAAAAAEAAACgMgAAVgcAAKr4//8BAAAAf39/AAEAAABkAAAAAAAAABQAAABAHwAAAAAAACYAAAAAAAAAwOD//wAAAAAmAAAAZAAAABYAAABMAAAAAAAAAAAAAAAEAAAAAAAAAAEAAABZWVkKAAAAACgAAAAoAAAAZAAAAGQAAAAAAAAAzMzMAAAAAABQAAAAUAAAAGQAAABkAAAAAAAAABcAAAAUAAAAAAAAAAAAAAD/fwAA/38AAAAAAAAJAAAABAAAAMgN8V0eAAAAaAAAAAAAAAAAAAAAAAAAAAAAAAAAAAAAECcAABAnAAAAAAAAAAAAAAAAAAAAAAAAAAAAAAAAAAAAAAAAAAAAABQAAAAAAAAAwMD/AAAAAABkAAAAMgAAAAAAAABkAAAAAAAAAH9/fwAKAAAAIgAAABgAAAAAAAAAAAAAAAAAAAAAAAAAAAAAAAAAAAAkAAAAJAAAAAAAAAAHAAAAAAAAAAAAAAAAAAAAAAAAAAAAAAAAAAAAf39/ACUAAABYAAAAAAAAAAAAAAAAAAAAAAAAAAAAAAAAAAAAAAAAAAAAAAAAAAAAAAAAAAAAAAA/AAAAAAAAAKCGAQAAAAAAAAAAAAAAAAAMAAAAAQAAAAAAAAAAAAAAAAAAAB8AAABUAAAAAAAABQAAAAEAAAAAAAAAAAAAAAAAAAAAAAAAAAAAAAAAAAAAAAAAAAAAAAJ/f38AWVlZA8zMzADAwP8Af39/AAAAAAAAAAAAAAAAAAAAAAAAAAAAIQAAABgAAAAUAAAAShMAAK8ZAABQNwAAgB4AAAAAAAAmAAAACAAAAD2wAAAAAAAA"/>
+                <pr:smNativeData xmlns:pr="smNativeData" xmlns="smNativeData" val="SMDATA_15_LkR5ZhMAAAAlAAAAZAAAAA0AAAAAkAAAAJAAAACQAAAAkAAAAAAAAAAAAAAAAAAAAAEAAABQAAAAAAAAAAAA4D8AAAAAAADgPwAAAAAAAOA/AAAAAAAA4D8AAAAAAADgPwAAAAAAAOA/AAAAAAAA4D8AAAAAAADgPwAAAAAAAOA/AAAAAAAA4D8CAAAAjAAAAAAAAAAAAAAAQoX0DP///wgAAAAAAAAAAAAAAAAAAAAAAAAAAAAAAAAAAAAAZAAAAAEAAABAAAAAAAAAAAAAAAAAAAAAAAAAAAAAAAAAAAAAAAAAAAAAAAAAAAAAAAAAAAAAAAAAAAAAAAAAAAAAAAAAAAAAAAAAAAAAAAAAAAAAAAAAAAAAAAAAAAAAFAAAADwAAAAAAAAAAAAAAAAAAAkUAAAAAQAAABQAAAAUAAAAFAAAAAEAAAAAAAAAZAAAAGQAAAAAAAAAZAAAAGQAAAAVAAAAYAAAAAAAAAAAAAAADwAAACADAAAAAAAAAAAAAAEAAACgMgAAVgcAAKr4//8BAAAAf39/AAEAAABkAAAAAAAAABQAAABAHwAAAAAAACYAAAAAAAAAwOD//wAAAAAmAAAAZAAAABYAAABMAAAAAAAAAAAAAAAEAAAAAAAAAAEAAABZWVkKAAAAACgAAAAoAAAAZAAAAGQAAAAAAAAAzMzMAAAAAABQAAAAUAAAAGQAAABkAAAAAAAAABcAAAAUAAAAAAAAAAAAAAD/fwAA/38AAAAAAAAJAAAABAAAAMgN8V0eAAAAaAAAAAAAAAAAAAAAAAAAAAAAAAAAAAAAECcAABAnAAAAAAAAAAAAAAAAAAAAAAAAAAAAAAAAAAAAAAAAAAAAABQAAAAAAAAAwMD/AAAAAABkAAAAMgAAAAAAAABkAAAAAAAAAH9/fwAKAAAAIgAAABgAAAAAAAAAAAAAAAAAAAAAAAAAAAAAAAAAAAAkAAAAJAAAAAAAAAAHAAAAAAAAAAAAAAAAAAAAAAAAAAAAAAAAAAAAf39/ACUAAABYAAAAAAAAAAAAAAAAAAAAAAAAAAAAAAAAAAAAAAAAAAAAAAAAAAAAAAAAAAAAAAA/AAAAAAAAAKCGAQAAAAAAAAAAAAAAAAAMAAAAAQAAAAAAAAAAAAAAAAAAAB8AAABUAAAAQoX0Bf///wEAAAAAAAAAAAAAAAAAAAAAAAAAAAAAAAAAAAAAAAAAAAAAAAJ/f38AWVlZA8zMzADAwP8Af39/AAAAAAAAAAAAAAAAAAAAAAAAAAAAIQAAABgAAAAUAAAAShMAAK8ZAABQNwAAgB4AABAAAAAmAAAACAAAAD2wAAAAAAAA"/>
               </a:ext>
             </a:extLst>
           </p:cNvSpPr>
@@ -11215,7 +10865,7 @@
             <a:spLocks noGrp="1" noChangeArrowheads="1"/>
             <a:extLst>
               <a:ext uri="smNativeData">
-                <pr:smNativeData xmlns:pr="smNativeData" xmlns="smNativeData" val="SMDATA_15_EkJ5ZhMAAAAlAAAAZAAAAA0AAAAAkAAAAJAAAACQAAAAkAAAAAAAAAAAAAAAAAAAAAEAAABQAAAAAAAAAAAA4D8AAAAAAADgPwAAAAAAAOA/AAAAAAAA4D8AAAAAAADgPwAAAAAAAOA/AAAAAAAA4D8AAAAAAADgPwAAAAAAAOA/AAAAAAAA4D8CAAAAjAAAAAAAAAAAAAAAQoX0DP///wgAAAAAAAAAAAAAAAAAAAAAAAAAAAAAAAAAAAAAZAAAAAEAAABAAAAAAAAAAAAAAAAAAAAAAAAAAAAAAAAAAAAAAAAAAAAAAAAAAAAAAAAAAAAAAAAAAAAAAAAAAAAAAAAAAAAAAAAAAAAAAAAAAAAAAAAAAAAAAAAAAAAAFAAAADwAAAAAAAAAAAAAAAAAAAkUAAAAAQAAABQAAAAUAAAAFAAAAAEAAAAAAAAAZAAAAGQAAAAAAAAAZAAAAGQAAAAVAAAAYAAAAAAAAAAAAAAADwAAACADAAAAAAAAAAAAAAEAAACgMgAAVgcAAKr4//8BAAAAf39/AAEAAABkAAAAAAAAABQAAABAHwAAAAAAACYAAAAAAAAAwOD//wAAAAAmAAAAZAAAABYAAABMAAAAAAAAAAAAAAAEAAAAAAAAAAEAAABZWVkKAAAAACgAAAAoAAAAZAAAAGQAAAAAAAAAzMzMAAAAAABQAAAAUAAAAGQAAABkAAAAAAAAABcAAAAUAAAAAAAAAAAAAAD/fwAA/38AAAAAAAAJAAAABAAAAIscKB0eAAAAaAAAAAAAAAAAAAAAAAAAAAAAAAAAAAAAECcAABAnAAAAAAAAAAAAAAAAAAAAAAAAAAAAAAAAAAAAAAAAAAAAABQAAAAAAAAAwMD/AAAAAABkAAAAMgAAAAAAAABkAAAAAAAAAH9/fwAKAAAAIgAAABgAAAAAAAAAAAAAAAAAAAAAAAAAAAAAAAAAAAAkAAAAJAAAAAAAAAAHAAAAAAAAAAAAAAAAAAAAAAAAAAAAAAAAAAAAf39/ACUAAABYAAAAAAAAAAAAAAAAAAAAAAAAAAAAAAAAAAAAAAAAAAAAAAAAAAAAAAAAAAAAAAA/AAAAAAAAAKCGAQAAAAAAAAAAAAAAAAAMAAAAAQAAAAAAAAAAAAAAAAAAAB8AAABUAAAAAAAABQAAAAEAAAAAAAAAAAAAAAAAAAAAAAAAAAAAAAAAAAAAAAAAAAAAAAJ/f38AWVlZA8zMzADAwP8Af39/AAAAAAAAAAAAAAAAAAAAAAAAAAAAIQAAABgAAAAUAAAAShMAACUcAABQNwAApSIAABAAAAAmAAAACAAAAD0wAAAAAAAA"/>
+                <pr:smNativeData xmlns:pr="smNativeData" xmlns="smNativeData" val="SMDATA_15_LkR5ZhMAAAAlAAAAZAAAAA0AAAAAkAAAAJAAAACQAAAAkAAAAAAAAAAAAAAAAAAAAAEAAABQAAAAAAAAAAAA4D8AAAAAAADgPwAAAAAAAOA/AAAAAAAA4D8AAAAAAADgPwAAAAAAAOA/AAAAAAAA4D8AAAAAAADgPwAAAAAAAOA/AAAAAAAA4D8CAAAAjAAAAAAAAAAAAAAAQoX0DP///wgAAAAAAAAAAAAAAAAAAAAAAAAAAAAAAAAAAAAAZAAAAAEAAABAAAAAAAAAAAAAAAAAAAAAAAAAAAAAAAAAAAAAAAAAAAAAAAAAAAAAAAAAAAAAAAAAAAAAAAAAAAAAAAAAAAAAAAAAAAAAAAAAAAAAAAAAAAAAAAAAAAAAFAAAADwAAAAAAAAAAAAAAAAAAAkUAAAAAQAAABQAAAAUAAAAFAAAAAEAAAAAAAAAZAAAAGQAAAAAAAAAZAAAAGQAAAAVAAAAYAAAAAAAAAAAAAAADwAAACADAAAAAAAAAAAAAAEAAACgMgAAVgcAAKr4//8BAAAAf39/AAEAAABkAAAAAAAAABQAAABAHwAAAAAAACYAAAAAAAAAwOD//wAAAAAmAAAAZAAAABYAAABMAAAAAAAAAAAAAAAEAAAAAAAAAAEAAABZWVkKAAAAACgAAAAoAAAAZAAAAGQAAAAAAAAAzMzMAAAAAABQAAAAUAAAAGQAAABkAAAAAAAAABcAAAAUAAAAAAAAAAAAAAD/fwAA/38AAAAAAAAJAAAABAAAAIscKB0eAAAAaAAAAAAAAAAAAAAAAAAAAAAAAAAAAAAAECcAABAnAAAAAAAAAAAAAAAAAAAAAAAAAAAAAAAAAAAAAAAAAAAAABQAAAAAAAAAwMD/AAAAAABkAAAAMgAAAAAAAABkAAAAAAAAAH9/fwAKAAAAIgAAABgAAAAAAAAAAAAAAAAAAAAAAAAAAAAAAAAAAAAkAAAAJAAAAAAAAAAHAAAAAAAAAAAAAAAAAAAAAAAAAAAAAAAAAAAAf39/ACUAAABYAAAAAAAAAAAAAAAAAAAAAAAAAAAAAAAAAAAAAAAAAAAAAAAAAAAAAAAAAAAAAAA/AAAAAAAAAKCGAQAAAAAAAAAAAAAAAAAMAAAAAQAAAAAAAAAAAAAAAAAAAB8AAABUAAAAQoX0Bf///wEAAAAAAAAAAAAAAAAAAAAAAAAAAAAAAAAAAAAAAAAAAAAAAAJ/f38AWVlZA8zMzADAwP8Af39/AAAAAAAAAAAAAAAAAAAAAAAAAAAAIQAAABgAAAAUAAAAShMAACUcAABQNwAApSIAABAAAAAmAAAACAAAAD0wAAAAAAAA"/>
               </a:ext>
             </a:extLst>
           </p:cNvSpPr>
@@ -11250,6 +10900,7 @@
               <a:rPr lang="ru-ru" cap="none"/>
               <a:t> </a:t>
             </a:r>
+            <a:endParaRPr lang="ru-ru" cap="none"/>
           </a:p>
         </p:txBody>
       </p:sp>
@@ -11260,7 +10911,7 @@
             <a:spLocks noGrp="1" noChangeArrowheads="1"/>
             <a:extLst>
               <a:ext uri="smNativeData">
-                <pr:smNativeData xmlns:pr="smNativeData" xmlns="smNativeData" val="SMDATA_15_EkJ5ZhMAAAAlAAAAZAAAAA0AAAAAkAAAAJAAAACQAAAAkAAAAAAAAAAAAAAAAAAAAAEAAABQAAAAAAAAAAAA4D8AAAAAAADgPwAAAAAAAOA/AAAAAAAA4D8AAAAAAADgPwAAAAAAAOA/AAAAAAAA4D8AAAAAAADgPwAAAAAAAOA/AAAAAAAA4D8CAAAAjAAAAAAAAAAAAAAAQoX0DP///wgAAAAAAAAAAAAAAAAAAAAAAAAAAAAAAAAAAAAAZAAAAAEAAABAAAAAAAAAAAAAAAAAAAAAAAAAAAAAAAAAAAAAAAAAAAAAAAAAAAAAAAAAAAAAAAAAAAAAAAAAAAAAAAAAAAAAAAAAAAAAAAAAAAAAAAAAAAAAAAAAAAAAFAAAADwAAAAAAAAAAAAAAAAAAAkUAAAAAQAAABQAAAAUAAAAFAAAAAEAAAAAAAAAZAAAAGQAAAAAAAAAZAAAAGQAAAAVAAAAYAAAAAAAAAAAAAAADwAAACADAAAAAAAAAAAAAAEAAACgMgAAVgcAAKr4//8BAAAAf39/AAEAAABkAAAAAAAAABQAAABAHwAAAAAAACYAAAAAAAAAwOD//wAAAAAmAAAAZAAAABYAAABMAAAAAAAAAAAAAAAEAAAAAAAAAAEAAABZWVkKAAAAACgAAAAoAAAAZAAAAGQAAAAAAAAAzMzMAAAAAABQAAAAUAAAAGQAAABkAAAAAAAAABcAAAAUAAAAAAAAAAAAAAD/fwAA/38AAAAAAAAJAAAABAAAAG28P2UeAAAAaAAAAAAAAAAAAAAAAAAAAAAAAAAAAAAAECcAABAnAAAAAAAAAAAAAAAAAAAAAAAAAAAAAAAAAAAAAAAAAAAAABQAAAAAAAAAwMD/AAAAAABkAAAAMgAAAAAAAABkAAAAAAAAAH9/fwAKAAAAIgAAABgAAAAAAAAAAAAAAAAAAAAAAAAAAAAAAAAAAAAkAAAAJAAAAAAAAAAHAAAAAAAAAAAAAAAAAAAAAAAAAAAAAAAAAAAAf39/ACUAAABYAAAAAAAAAAAAAAAAAAAAAAAAAAAAAAAAAAAAAAAAAAAAAAAAAAAAAAAAAAAAAAA/AAAAAAAAAKCGAQAAAAAAAAAAAAAAAAAMAAAAAQAAAAAAAAAAAAAAAAAAAB8AAABUAAAAAAAABQAAAAEAAAAAAAAAAAAAAAAAAAAAAAAAAAAAAAAAAAAAAAAAAAAAAAJ/f38AWVlZA8zMzADAwP8Af39/AAAAAAAAAAAAAAAAAAAAAAAAAAAAIQAAABgAAAAUAAAAShMAACUdAABQNwAAniUAAAAAAAAmAAAACAAAAD0wAAAAAAAA"/>
+                <pr:smNativeData xmlns:pr="smNativeData" xmlns="smNativeData" val="SMDATA_15_LkR5ZhMAAAAlAAAAZAAAAA0AAAAAkAAAAJAAAACQAAAAkAAAAAAAAAAAAAAAAAAAAAEAAABQAAAAAAAAAAAA4D8AAAAAAADgPwAAAAAAAOA/AAAAAAAA4D8AAAAAAADgPwAAAAAAAOA/AAAAAAAA4D8AAAAAAADgPwAAAAAAAOA/AAAAAAAA4D8CAAAAjAAAAAAAAAAAAAAAQoX0DP///wgAAAAAAAAAAAAAAAAAAAAAAAAAAAAAAAAAAAAAZAAAAAEAAABAAAAAAAAAAAAAAAAAAAAAAAAAAAAAAAAAAAAAAAAAAAAAAAAAAAAAAAAAAAAAAAAAAAAAAAAAAAAAAAAAAAAAAAAAAAAAAAAAAAAAAAAAAAAAAAAAAAAAFAAAADwAAAAAAAAAAAAAAAAAAAkUAAAAAQAAABQAAAAUAAAAFAAAAAEAAAAAAAAAZAAAAGQAAAAAAAAAZAAAAGQAAAAVAAAAYAAAAAAAAAAAAAAADwAAACADAAAAAAAAAAAAAAEAAACgMgAAVgcAAKr4//8BAAAAf39/AAEAAABkAAAAAAAAABQAAABAHwAAAAAAACYAAAAAAAAAwOD//wAAAAAmAAAAZAAAABYAAABMAAAAAAAAAAAAAAAEAAAAAAAAAAEAAABZWVkKAAAAACgAAAAoAAAAZAAAAGQAAAAAAAAAzMzMAAAAAABQAAAAUAAAAGQAAABkAAAAAAAAABcAAAAUAAAAAAAAAAAAAAD/fwAA/38AAAAAAAAJAAAABAAAAG28P2UeAAAAaAAAAAAAAAAAAAAAAAAAAAAAAAAAAAAAECcAABAnAAAAAAAAAAAAAAAAAAAAAAAAAAAAAAAAAAAAAAAAAAAAABQAAAAAAAAAwMD/AAAAAABkAAAAMgAAAAAAAABkAAAAAAAAAH9/fwAKAAAAIgAAABgAAAAAAAAAAAAAAAAAAAAAAAAAAAAAAAAAAAAkAAAAJAAAAAAAAAAHAAAAAAAAAAAAAAAAAAAAAAAAAAAAAAAAAAAAf39/ACUAAABYAAAAAAAAAAAAAAAAAAAAAAAAAAAAAAAAAAAAAAAAAAAAAAAAAAAAAAAAAAAAAAA/AAAAAAAAAKCGAQAAAAAAAAAAAAAAAAAMAAAAAQAAAAAAAAAAAAAAAAAAAB8AAABUAAAAQoX0Bf///wEAAAAAAAAAAAAAAAAAAAAAAAAAAAAAAAAAAAAAAAAAAAAAAAJ/f38AWVlZA8zMzADAwP8Af39/AAAAAAAAAAAAAAAAAAAAAAAAAAAAIQAAABgAAAAUAAAAShMAACUdAABQNwAAniUAABAAAAAmAAAACAAAAD0wAAAAAAAA"/>
               </a:ext>
             </a:extLst>
           </p:cNvSpPr>
@@ -11328,7 +10979,7 @@
             <a:picLocks noChangeAspect="1"/>
             <a:extLst>
               <a:ext uri="smNativeData">
-                <pr:smNativeData xmlns:pr="smNativeData" xmlns="smNativeData" val="SMDATA_17_EkJ5ZhMAAAAlAAAAEQAAAC8BAAAAkAAAAEgAAACQAAAASAAAAAAAAAAAAAAAAAAAAAEAAABQAAAAAAAAAAAA4D8AAAAAAADgPwAAAAAAAOA/AAAAAAAA4D8AAAAAAADgPwAAAAAAAOA/AAAAAAAA4D8AAAAAAADgPwAAAAAAAOA/AAAAAAAA4D8CAAAAjAAAAAAAAAAAAAAAQoX0DP///wgAAAAAAAAAAAAAAAAAAAAAAAAAAAAAAAAAAAAAZAAAAAEAAABAAAAAAAAAAAAAAAAAAAAAAAAAAAAAAAAAAAAAAAAAAAAAAAAAAAAAAAAAAAAAAAAAAAAAAAAAAAAAAAAAAAAAAAAAAAAAAAAAAAAAAAAAAAAAAAAAAAAAFAAAADwAAAAAAAAAAAAAAAAAAAkUAAAAAQAAABQAAAAUAAAAFAAAAAEAAAAAAAAAZAAAAGQAAAAAAAAAZAAAAGQAAAAVAAAAYAAAAAAAAAAAAAAADwAAACADAAAAAAAAAAAAAAEAAACgMgAAVgcAAKr4//8BAAAAf39/AAEAAABkAAAAAAAAABQAAABAHwAAAAAAACYAAAAAAAAAwOD//wAAAAAmAAAAZAAAABYAAABMAAAAAAAAAAAAAAAEAAAAAAAAAAEAAABZWVkKAAAAACgAAAAoAAAAZAAAAGQAAAAAAAAAzMzMAAAAAABQAAAAUAAAAGQAAABkAAAAAAAAAAcAAAA4AAAAAAAAAAAAAAAAAAAA////AAAAAAAAAAAAAAAAAAAAAAAAAAAAAAAAAAAAAABkAAAAZAAAAAAAAAAjAAAABAAAAGQAAAAXAAAAFAAAAAAAAAAAAAAA/38AAP9/AAAAAAAACQAAAAQAAAAAAAAAHgAAAGgAAAAAAAAAAAAAAAAAAAAAAAAAAAAAABAnAAAQJwAAAAAAAAAAAAAAAAAAAAAAAAAAAAAAAAAAAAAAAAAAAAAUAAAAAAAAAMDA/wAAAAAAZAAAADIAAAAAAAAAZAAAAAAAAAB/f38ACgAAACIAAAAYAAAAAAAAAAAAAAAAAAAAAAAAAAAAAAAAAAAAJAAAACQAAAAAAAAABwAAAAAAAAAAAAAAAAAAAAAAAAAAAAAAAAAAAH9/fwAlAAAAWAAAAAAAAAAAAAAAAAAAAAAAAAAAAAAAAAAAAAAAAAAAAAAAAAAAAAAAAAAAAAAAPwAAAAAAAACghgEAAAAAAAAAAAAAAAAADAAAAAEAAAAAAAAAAAAAAAAAAAAfAAAAVAAAAEKF9AX///8BAAAAAAAAAAAAAAAAAAAAAAAAAAAAAAAAAAAAAAAAAAAAAAACf39/AFlZWQPMzMwAwMD/AH9/fwAAAAAAAAAAAAAAAAD///8AAAAAACEAAAAYAAAAFAAAAMgDAADNFgAAgQ8AAJ8lAAAAAAAAJgAAAAgAAAD//////////w=="/>
+                <pr:smNativeData xmlns:pr="smNativeData" xmlns="smNativeData" val="SMDATA_17_LkR5ZhMAAAAlAAAAEQAAAC8BAAAAkAAAAEgAAACQAAAASAAAAAAAAAAAAAAAAAAAAAEAAABQAAAAAAAAAAAA4D8AAAAAAADgPwAAAAAAAOA/AAAAAAAA4D8AAAAAAADgPwAAAAAAAOA/AAAAAAAA4D8AAAAAAADgPwAAAAAAAOA/AAAAAAAA4D8CAAAAjAAAAAAAAAAAAAAAQoX0DP///wgAAAAAAAAAAAAAAAAAAAAAAAAAAAAAAAAAAAAAZAAAAAEAAABAAAAAAAAAAAAAAAAAAAAAAAAAAAAAAAAAAAAAAAAAAAAAAAAAAAAAAAAAAAAAAAAAAAAAAAAAAAAAAAAAAAAAAAAAAAAAAAAAAAAAAAAAAAAAAAAAAAAAFAAAADwAAAAAAAAAAAAAAAAAAAkUAAAAAQAAABQAAAAUAAAAFAAAAAEAAAAAAAAAZAAAAGQAAAAAAAAAZAAAAGQAAAAVAAAAYAAAAAAAAAAAAAAADwAAACADAAAAAAAAAAAAAAEAAACgMgAAVgcAAKr4//8BAAAAf39/AAEAAABkAAAAAAAAABQAAABAHwAAAAAAACYAAAAAAAAAwOD//wAAAAAmAAAAZAAAABYAAABMAAAAAAAAAAAAAAAEAAAAAAAAAAEAAABZWVkKAAAAACgAAAAoAAAAZAAAAGQAAAAAAAAAzMzMAAAAAABQAAAAUAAAAGQAAABkAAAAAAAAAAcAAAA4AAAAAAAAAAAAAAAAAAAA////AAAAAAAAAAAAAAAAAAAAAAAAAAAAAAAAAAAAAABkAAAAZAAAAAAAAAAjAAAABAAAAGQAAAAXAAAAFAAAAAAAAAAAAAAA/38AAP9/AAAAAAAACQAAAAQAAAAAAAAAHgAAAGgAAAAAAAAAAAAAAAAAAAAAAAAAAAAAABAnAAAQJwAAAAAAAAAAAAAAAAAAAAAAAAAAAAAAAAAAAAAAAAAAAAAUAAAAAAAAAMDA/wAAAAAAZAAAADIAAAAAAAAAZAAAAAAAAAB/f38ACgAAACIAAAAYAAAAAAAAAAAAAAAAAAAAAAAAAAAAAAAAAAAAJAAAACQAAAAAAAAABwAAAAAAAAAAAAAAAAAAAAAAAAAAAAAAAAAAAH9/fwAlAAAAWAAAAAAAAAAAAAAAAAAAAAAAAAAAAAAAAAAAAAAAAAAAAAAAAAAAAAAAAAAAAAAAPwAAAAAAAACghgEAAAAAAAAAAAAAAAAADAAAAAEAAAAAAAAAAAAAAAAAAAAfAAAAVAAAAEKF9AX///8BAAAAAAAAAAAAAAAAAAAAAAAAAAAAAAAAAAAAAAAAAAAAAAACf39/AFlZWQPMzMwAwMD/AH9/fwAAAAAAAAAAAAAAAAD///8AAAAAACEAAAAYAAAAFAAAAHgEAACpGAAA0Q4AAL8lAAAQAAAAJgAAAAgAAAD//////////w=="/>
               </a:ext>
             </a:extLst>
           </p:cNvPicPr>
@@ -11342,8 +10993,8 @@
         </p:blipFill>
         <p:spPr>
           <a:xfrm>
-            <a:off x="614680" y="3706495"/>
-            <a:ext cx="1905635" cy="2409190"/>
+            <a:off x="726440" y="4008755"/>
+            <a:ext cx="1682115" cy="2127250"/>
           </a:xfrm>
           <a:prstGeom prst="rect">
             <a:avLst/>
@@ -11394,7 +11045,7 @@
             <a:spLocks noGrp="1" noChangeArrowheads="1"/>
             <a:extLst>
               <a:ext uri="smNativeData">
-                <pr:smNativeData xmlns:pr="smNativeData" xmlns="smNativeData" val="SMDATA_15_EkJ5ZhMAAAAlAAAAZAAAAA0AAAAAkAAAAJAAAACQAAAAkAAAAAAAAAAAAAAAAAAAAAEAAABQAAAAAAAAAAAA4D8AAAAAAADgPwAAAAAAAOA/AAAAAAAA4D8AAAAAAADgPwAAAAAAAOA/AAAAAAAA4D8AAAAAAADgPwAAAAAAAOA/AAAAAAAA4D8CAAAAjAAAAAAAAAAAAAAAQoX0DP///wgAAAAAAAAAAAAAAAAAAAAAAAAAAAAAAAAAAAAAZAAAAAEAAABAAAAAAAAAAAAAAAAAAAAAAAAAAAAAAAAAAAAAAAAAAAAAAAAAAAAAAAAAAAAAAAAAAAAAAAAAAAAAAAAAAAAAAAAAAAAAAAAAAAAAAAAAAAAAAAAAAAAAFAAAADwAAAAAAAAAAAAAAAAAAAkUAAAAAQAAABQAAAAUAAAAFAAAAAEAAAAAAAAAZAAAAGQAAAAAAAAAZAAAAGQAAAAVAAAAYAAAAAAAAAAAAAAADwAAACADAAAAAAAAAAAAAAEAAACgMgAAVgcAAKr4//8BAAAAf39/AAEAAABkAAAAAAAAABQAAABAHwAAAAAAACYAAAAAAAAAwOD//wAAAAAmAAAAZAAAABYAAABMAAAAAAAAAAAAAAAEAAAAAAAAAAEAAABZWVkKAAAAACgAAAAoAAAAZAAAAGQAAAAAAAAAzMzMAAAAAABQAAAAUAAAAGQAAABkAAAAAAAAABcAAAAUAAAAAAAAAAAAAAD/fwAA/38AAAAAAAAJAAAABAAAAF8AYAAeAAAAaAAAAAAAAAAAAAAAAAAAAAAAAAAAAAAAECcAABAnAAAAAAAAAAAAAAAAAAAAAAAAAAAAAAAAAAAAAAAAAAAAABQAAAAAAAAAwMD/AAAAAABkAAAAMgAAAAAAAABkAAAAAAAAAH9/fwAKAAAAIgAAABgAAAAAAAAAAAAAAAAAAAAAAAAAAAAAAAAAAAAkAAAAJAAAAAAAAAAHAAAAAAAAAAAAAAAAAAAAAAAAAAAAAAAAAAAAf39/ACUAAABYAAAAAAAAAAAAAAAAAAAAAAAAAAAAAAAAAAAAAAAAAAAAAAAAAAAAAAAAAAAAAAA/AAAAAAAAAKCGAQAAAAAAAAAAAAAAAAAMAAAAAQAAAAAAAAAAAAAAAAAAAB8AAABUAAAAAAAABQAAAAEAAAAAAAAAAAAAAAAAAAAAAAAAAAAAAAAAAAAAAAAAAAAAAAJ/f38AWVlZA8zMzADAwP8Af39/AAAAAAAAAAAAAAAAAAAAAAAAAAAAIQAAABgAAAAUAAAAFAMAALYCAAB/NwAAVAcAABAAAAAmAAAACAAAAD0wAAAAAAAA"/>
+                <pr:smNativeData xmlns:pr="smNativeData" xmlns="smNativeData" val="SMDATA_15_LkR5ZhMAAAAlAAAAZAAAAA0AAAAAkAAAAJAAAACQAAAAkAAAAAAAAAAAAAAAAAAAAAEAAABQAAAAAAAAAAAA4D8AAAAAAADgPwAAAAAAAOA/AAAAAAAA4D8AAAAAAADgPwAAAAAAAOA/AAAAAAAA4D8AAAAAAADgPwAAAAAAAOA/AAAAAAAA4D8CAAAAjAAAAAAAAAAAAAAAQoX0DP///wgAAAAAAAAAAAAAAAAAAAAAAAAAAAAAAAAAAAAAZAAAAAEAAABAAAAAAAAAAAAAAAAAAAAAAAAAAAAAAAAAAAAAAAAAAAAAAAAAAAAAAAAAAAAAAAAAAAAAAAAAAAAAAAAAAAAAAAAAAAAAAAAAAAAAAAAAAAAAAAAAAAAAFAAAADwAAAAAAAAAAAAAAAAAAAkUAAAAAQAAABQAAAAUAAAAFAAAAAEAAAAAAAAAZAAAAGQAAAAAAAAAZAAAAGQAAAAVAAAAYAAAAAAAAAAAAAAADwAAACADAAAAAAAAAAAAAAEAAACgMgAAVgcAAKr4//8BAAAAf39/AAEAAABkAAAAAAAAABQAAABAHwAAAAAAACYAAAAAAAAAwOD//wAAAAAmAAAAZAAAABYAAABMAAAAAAAAAAAAAAAEAAAAAAAAAAEAAABZWVkKAAAAACgAAAAoAAAAZAAAAGQAAAAAAAAAzMzMAAAAAABQAAAAUAAAAGQAAABkAAAAAAAAABcAAAAUAAAAAAAAAAAAAAD/fwAA/38AAAAAAAAJAAAABAAAAF8AYAAeAAAAaAAAAAAAAAAAAAAAAAAAAAAAAAAAAAAAECcAABAnAAAAAAAAAAAAAAAAAAAAAAAAAAAAAAAAAAAAAAAAAAAAABQAAAAAAAAAwMD/AAAAAABkAAAAMgAAAAAAAABkAAAAAAAAAH9/fwAKAAAAIgAAABgAAAAAAAAAAAAAAAAAAAAAAAAAAAAAAAAAAAAkAAAAJAAAAAAAAAAHAAAAAAAAAAAAAAAAAAAAAAAAAAAAAAAAAAAAf39/ACUAAABYAAAAAAAAAAAAAAAAAAAAAAAAAAAAAAAAAAAAAAAAAAAAAAAAAAAAAAAAAAAAAAA/AAAAAAAAAKCGAQAAAAAAAAAAAAAAAAAMAAAAAQAAAAAAAAAAAAAAAAAAAB8AAABUAAAAQoX0Bf///wEAAAAAAAAAAAAAAAAAAAAAAAAAAAAAAAAAAAAAAAAAAAAAAAJ/f38AWVlZA8zMzADAwP8Af39/AAAAAAAAAAAAAAAAAAAAAAAAAAAAIQAAABgAAAAUAAAAFAMAALYCAAB/NwAAVAcAABAAAAAmAAAACAAAAD0wAAAAAAAA"/>
               </a:ext>
             </a:extLst>
           </p:cNvSpPr>
@@ -11429,6 +11080,7 @@
               <a:rPr lang="ru-ru" cap="none"/>
               <a:t>План защиты</a:t>
             </a:r>
+            <a:endParaRPr lang="ru-ru" cap="none"/>
           </a:p>
         </p:txBody>
       </p:sp>
@@ -11438,7 +11090,7 @@
           <p:cNvSpPr>
             <a:extLst>
               <a:ext uri="smNativeData">
-                <pr:smNativeData xmlns:pr="smNativeData" xmlns="smNativeData" val="SMDATA_15_EkJ5ZhMAAAAlAAAAZQAAAA0AAAAAqQEAAJAAAACpAQAAkAAAAAAAAAABAAAAAAAAAAEAAABQAAAAhbacS3FV1T8AAAAAAADwvwAAAAAAAOA/AAAAAAAA4D8AAAAAAADgPwAAAAAAAOA/AAAAAAAA4D8AAAAAAADgPwAAAAAAAOA/AAAAAAAA4D8CAAAAjAAAAAEAAAAAAAAAi47jAP///wgAAAAAAAAAAAAAAAAAAAAAAAAAAAAAAAAAAAAAeAAAAAEAAABAAAAAAAAAAAAAAABaAAAAAAAAAAAAAAAAAAAAAAAAAAAAAAAAAAAAAAAAAAAAAAAAAAAAAAAAAAAAAAAAAAAAAAAAAAAAAAAAAAAAAAAAAAAAAAAAAAAAFAAAADwAAAAAAAAAAAAAAAAAAAkUAAAAAQAAABQAAAAUAAAAFAAAAAEAAAAAAAAAZAAAAGQAAAAAAAAAZAAAAGQAAAAVAAAAYAAAAAAAAAAAAAAADwAAACADAAAAAAAAAAAAAAEAAACgMgAAVgcAAKr4//8BAAAAf39/AAEAAABkAAAAAAAAABQAAABAHwAAAAAAACYAAAAAAAAAwOD//wAAAAAmAAAAZAAAABYAAABMAAAAAAAAAAAAAAAEAAAAAAAAAAEAAABZWVkKAAAAACgAAAAoAAAAZAAAAGQAAAAAAAAAzMzMAAAAAABQAAAAUAAAAGQAAABkAAAAAAAAABcAAAAUAAAAAAAAAAAAAAD/fwAA/38AAAAAAAAJAAAABAAAAEqKdAoeAAAAaAAAAAAAAAAAAAAAAAAAAAAAAAAAAAAAECcAABAnAAAAAAAAAAAAAAAAAAAAAAAAAAAAAAAAAAAAAAAAAAAAABQAAAAAAAAAwMD/AAAAAABkAAAAMgAAAAAAAABkAAAAAAAAAH9/fwAKAAAAIgAAABgAAAAAAAAAAAAAAAAAAAAAAAAAAAAAAAAAAAAkAAAAJAAAAAAAAAAHAAAAAAAAAAAAAAAAAAAAAAAAAAAAAAAAAAAAf39/ACUAAABYAAAAAAAAAAAAAAAAAAAAAAAAAAAAAAAAAAAAAAAAAAAAAAAAAAAAAAAAAAAAAAA/AAAAAAAAAKCGAQAAAAAAAAAAAAAAAAAMAAAAAQAAAAAAAAAAAAAAAAAAAB8AAABUAAAAi47jAP///wEAAAAAAAAAAAAAAAAAAAAAAAAAAAAAAAAAAAAAAAAAAAAAAAJ/f38AWVlZA8zMzADAwP8Af39/AAAAAAAAAAAAAAAAAAAAAAAAAAAAIQAAABgAAAAUAAAAMAQAAM0IAAADGQAA4wsAABAAAAAmAAAACAAAAP//////////"/>
+                <pr:smNativeData xmlns:pr="smNativeData" xmlns="smNativeData" val="SMDATA_15_LkR5ZhMAAAAlAAAAZQAAAA0AAAAAqQEAAJAAAACpAQAAkAAAAAAAAAABAAAAAAAAAAEAAABQAAAAhbacS3FV1T8AAAAAAAAAAAAAAAAAAOA/AAAAAAAA4D8AAAAAAADgPwAAAAAAAOA/AAAAAAAA4D8AAAAAAADgPwAAAAAAAOA/AAAAAAAA4D8CAAAAjAAAAAEAAAAAAAAAi47jAP///wgAAAAAAAAAAAAAAAAAAAAAAAAAAAAAAAAAAAAAeAAAAAEAAABAAAAAAAAAAAAAAABaAAAAAAAAAAAAAAAAAAAAAAAAAAAAAAAAAAAAAAAAAAAAAAAAAAAAAAAAAAAAAAAAAAAAAAAAAAAAAAAAAAAAAAAAAAAAAAAAAAAAFAAAADwAAAAAAAAAAAAAAAAAAAkUAAAAAQAAABQAAAAUAAAAFAAAAAEAAAAAAAAAZAAAAGQAAAAAAAAAZAAAAGQAAAAVAAAAYAAAAAAAAAAAAAAADwAAACADAAAAAAAAAAAAAAEAAACgMgAAVgcAAKr4//8BAAAAf39/AAEAAABkAAAAAAAAABQAAABAHwAAAAAAACYAAAAAAAAAwOD//wAAAAAmAAAAZAAAABYAAABMAAAAAAAAAAAAAAAEAAAAAAAAAAEAAABZWVkKAAAAACgAAAAoAAAAZAAAAGQAAAAAAAAAzMzMAAAAAABQAAAAUAAAAGQAAABkAAAAAAAAABcAAAAUAAAAAAAAAAAAAAD/fwAA/38AAAAAAAAJAAAABAAAAEqKdAoeAAAAaAAAAAAAAAAAAAAAAAAAAAAAAAAAAAAAECcAABAnAAAAAAAAAAAAAAAAAAAAAAAAAAAAAAAAAAAAAAAAAAAAABQAAAAAAAAAwMD/AAAAAABkAAAAMgAAAAAAAABkAAAAAAAAAH9/fwAKAAAAIgAAABgAAAAAAAAAAAAAAAAAAAAAAAAAAAAAAAAAAAAkAAAAJAAAAAAAAAAHAAAAAAAAAAAAAAAAAAAAAAAAAAAAAAAAAAAAf39/ACUAAABYAAAAAAAAAAAAAAAAAAAAAAAAAAAAAAAAAAAAAAAAAAAAAAAAAAAAAAAAAAAAAAA/AAAAAAAAAKCGAQAAAAAAAAAAAAAAAAAMAAAAAQAAAAAAAAAAAAAAAAAAAB8AAABUAAAAi47jAP///wEAAAAAAAAAAAAAAAAAAAAAAAAAAAAAAAAAAAAAAAAAAAAAAAJ/f38AWVlZA8zMzADAwP8Af39/AAAAAAAAAAAAAAAAAAAAAAAAAAAAIQAAABgAAAAUAAAAMAQAAM0IAAADGQAA4wsAABAAAAAmAAAACAAAAP//////////"/>
               </a:ext>
             </a:extLst>
           </p:cNvSpPr>
@@ -11503,7 +11155,7 @@
           <p:cNvSpPr>
             <a:extLst>
               <a:ext uri="smNativeData">
-                <pr:smNativeData xmlns:pr="smNativeData" xmlns="smNativeData" val="SMDATA_15_EkJ5ZhMAAAAlAAAAZQAAAA0AAAAAqQEAAJAAAACpAQAAkAAAAAAAAAABAAAAAAAAAAEAAABQAAAAhbacS3FV1T8AAAAAAADwvwAAAAAAAOA/AAAAAAAA4D8AAAAAAADgPwAAAAAAAOA/AAAAAAAA4D8AAAAAAADgPwAAAAAAAOA/AAAAAAAA4D8CAAAAjAAAAAEAAAAAAAAAi47jAP///wgAAAAAAAAAAAAAAAAAAAAAAAAAAAAAAAAAAAAAeAAAAAEAAABAAAAAAAAAAAAAAABaAAAAAAAAAAAAAAAAAAAAAAAAAAAAAAAAAAAAAAAAAAAAAAAAAAAAAAAAAAAAAAAAAAAAAAAAAAAAAAAAAAAAAAAAAAAAAAAAAAAAFAAAADwAAAAAAAAAAAAAAAAAAAkUAAAAAQAAABQAAAAUAAAAFAAAAAEAAAAAAAAAZAAAAGQAAAAAAAAAZAAAAGQAAAAVAAAAYAAAAAAAAAAAAAAADwAAACADAAAAAAAAAAAAAAEAAACgMgAAVgcAAKr4//8BAAAAf39/AAEAAABkAAAAAAAAABQAAABAHwAAAAAAACYAAAAAAAAAwOD//wAAAAAmAAAAZAAAABYAAABMAAAAAAAAAAAAAAAEAAAAAAAAAAEAAABZWVkKAAAAACgAAAAoAAAAZAAAAGQAAAAAAAAAzMzMAAAAAABQAAAAUAAAAGQAAABkAAAAAAAAABcAAAAUAAAAAAAAAAAAAAD/fwAA/38AAAAAAAAJAAAABAAAAMdydoweAAAAaAAAAAAAAAAAAAAAAAAAAAAAAAAAAAAAECcAABAnAAAAAAAAAAAAAAAAAAAAAAAAAAAAAAAAAAAAAAAAAAAAABQAAAAAAAAAwMD/AAAAAABkAAAAMgAAAAAAAABkAAAAAAAAAH9/fwAKAAAAIgAAABgAAAAAAAAAAAAAAAAAAAAAAAAAAAAAAAAAAAAkAAAAJAAAAAAAAAAHAAAAAAAAAAAAAAAAAAAAAAAAAAAAAAAAAAAAf39/ACUAAABYAAAAAAAAAAAAAAAAAAAAAAAAAAAAAAAAAAAAAAAAAAAAAAAAAAAAAAAAAAAAAAA/AAAAAAAAAKCGAQAAAAAAAAAAAAAAAAAMAAAAAQAAAAAAAAAAAAAAAAAAAB8AAABUAAAAi47jAP///wEAAAAAAAAAAAAAAAAAAAAAAAAAAAAAAAAAAAAAAAAAAAAAAAJ/f38AWVlZA8zMzADAwP8Af39/AAAAAAAAAAAAAAAAAAAAAAAAAAAAIQAAABgAAAAUAAAAMAQAAN4NAAADGQAA9BAAABAAAAAmAAAACAAAAP//////////"/>
+                <pr:smNativeData xmlns:pr="smNativeData" xmlns="smNativeData" val="SMDATA_15_LkR5ZhMAAAAlAAAAZQAAAA0AAAAAqQEAAJAAAACpAQAAkAAAAAAAAAABAAAAAAAAAAEAAABQAAAAhbacS3FV1T8AAAAAAAAAAAAAAAAAAOA/AAAAAAAA4D8AAAAAAADgPwAAAAAAAOA/AAAAAAAA4D8AAAAAAADgPwAAAAAAAOA/AAAAAAAA4D8CAAAAjAAAAAEAAAAAAAAAi47jAP///wgAAAAAAAAAAAAAAAAAAAAAAAAAAAAAAAAAAAAAeAAAAAEAAABAAAAAAAAAAAAAAABaAAAAAAAAAAAAAAAAAAAAAAAAAAAAAAAAAAAAAAAAAAAAAAAAAAAAAAAAAAAAAAAAAAAAAAAAAAAAAAAAAAAAAAAAAAAAAAAAAAAAFAAAADwAAAAAAAAAAAAAAAAAAAkUAAAAAQAAABQAAAAUAAAAFAAAAAEAAAAAAAAAZAAAAGQAAAAAAAAAZAAAAGQAAAAVAAAAYAAAAAAAAAAAAAAADwAAACADAAAAAAAAAAAAAAEAAACgMgAAVgcAAKr4//8BAAAAf39/AAEAAABkAAAAAAAAABQAAABAHwAAAAAAACYAAAAAAAAAwOD//wAAAAAmAAAAZAAAABYAAABMAAAAAAAAAAAAAAAEAAAAAAAAAAEAAABZWVkKAAAAACgAAAAoAAAAZAAAAGQAAAAAAAAAzMzMAAAAAABQAAAAUAAAAGQAAABkAAAAAAAAABcAAAAUAAAAAAAAAAAAAAD/fwAA/38AAAAAAAAJAAAABAAAAMdydoweAAAAaAAAAAAAAAAAAAAAAAAAAAAAAAAAAAAAECcAABAnAAAAAAAAAAAAAAAAAAAAAAAAAAAAAAAAAAAAAAAAAAAAABQAAAAAAAAAwMD/AAAAAABkAAAAMgAAAAAAAABkAAAAAAAAAH9/fwAKAAAAIgAAABgAAAAAAAAAAAAAAAAAAAAAAAAAAAAAAAAAAAAkAAAAJAAAAAAAAAAHAAAAAAAAAAAAAAAAAAAAAAAAAAAAAAAAAAAAf39/ACUAAABYAAAAAAAAAAAAAAAAAAAAAAAAAAAAAAAAAAAAAAAAAAAAAAAAAAAAAAAAAAAAAAA/AAAAAAAAAKCGAQAAAAAAAAAAAAAAAAAMAAAAAQAAAAAAAAAAAAAAAAAAAB8AAABUAAAAi47jAP///wEAAAAAAAAAAAAAAAAAAAAAAAAAAAAAAAAAAAAAAAAAAAAAAAJ/f38AWVlZA8zMzADAwP8Af39/AAAAAAAAAAAAAAAAAAAAAAAAAAAAIQAAABgAAAAUAAAAMAQAAN4NAAADGQAA9BAAABAAAAAmAAAACAAAAP//////////"/>
               </a:ext>
             </a:extLst>
           </p:cNvSpPr>
@@ -11568,7 +11220,7 @@
           <p:cNvSpPr>
             <a:extLst>
               <a:ext uri="smNativeData">
-                <pr:smNativeData xmlns:pr="smNativeData" xmlns="smNativeData" val="SMDATA_15_EkJ5ZhMAAAAlAAAAZQAAAA0AAAAAqQEAAJAAAACpAQAAkAAAAAAAAAABAAAAAAAAAAEAAABQAAAAhbacS3FV1T8AAAAAAADwvwAAAAAAAOA/AAAAAAAA4D8AAAAAAADgPwAAAAAAAOA/AAAAAAAA4D8AAAAAAADgPwAAAAAAAOA/AAAAAAAA4D8CAAAAjAAAAAEAAAAAAAAAi47jAP///wgAAAAAAAAAAAAAAAAAAAAAAAAAAAAAAAAAAAAAeAAAAAEAAABAAAAAAAAAAAAAAABaAAAAAAAAAAAAAAAAAAAAAAAAAAAAAAAAAAAAAAAAAAAAAAAAAAAAAAAAAAAAAAAAAAAAAAAAAAAAAAAAAAAAAAAAAAAAAAAAAAAAFAAAADwAAAAAAAAAAAAAAAAAAAkUAAAAAQAAABQAAAAUAAAAFAAAAAEAAAAAAAAAZAAAAGQAAAAAAAAAZAAAAGQAAAAVAAAAYAAAAAAAAAAAAAAADwAAACADAAAAAAAAAAAAAAEAAACgMgAAVgcAAKr4//8BAAAAf39/AAEAAABkAAAAAAAAABQAAABAHwAAAAAAACYAAAAAAAAAwOD//wAAAAAmAAAAZAAAABYAAABMAAAAAAAAAAAAAAAEAAAAAAAAAAEAAABZWVkKAAAAACgAAAAoAAAAZAAAAGQAAAAAAAAAzMzMAAAAAABQAAAAUAAAAGQAAABkAAAAAAAAABcAAAAUAAAAAAAAAAAAAAD/fwAA/38AAAAAAAAJAAAABAAAAE554FYeAAAAaAAAAAAAAAAAAAAAAAAAAAAAAAAAAAAAECcAABAnAAAAAAAAAAAAAAAAAAAAAAAAAAAAAAAAAAAAAAAAAAAAABQAAAAAAAAAwMD/AAAAAABkAAAAMgAAAAAAAABkAAAAAAAAAH9/fwAKAAAAIgAAABgAAAAAAAAAAAAAAAAAAAAAAAAAAAAAAAAAAAAkAAAAJAAAAAAAAAAHAAAAAAAAAAAAAAAAAAAAAAAAAAAAAAAAAAAAf39/ACUAAABYAAAAAAAAAAAAAAAAAAAAAAAAAAAAAAAAAAAAAAAAAAAAAAAAAAAAAAAAAAAAAAA/AAAAAAAAAKCGAQAAAAAAAAAAAAAAAAAMAAAAAQAAAAAAAAAAAAAAAAAAAB8AAABUAAAAi47jAP///wEAAAAAAAAAAAAAAAAAAAAAAAAAAAAAAAAAAAAAAAAAAAAAAAJ/f38AWVlZA8zMzADAwP8Af39/AAAAAAAAAAAAAAAAAAAAAAAAAAAAIQAAABgAAAAUAAAAMAQAAAQTAAADGQAAGhYAABAAAAAmAAAACAAAAP//////////"/>
+                <pr:smNativeData xmlns:pr="smNativeData" xmlns="smNativeData" val="SMDATA_15_LkR5ZhMAAAAlAAAAZQAAAA0AAAAAqQEAAJAAAACpAQAAkAAAAAAAAAABAAAAAAAAAAEAAABQAAAAhbacS3FV1T8AAAAAAAAAAAAAAAAAAOA/AAAAAAAA4D8AAAAAAADgPwAAAAAAAOA/AAAAAAAA4D8AAAAAAADgPwAAAAAAAOA/AAAAAAAA4D8CAAAAjAAAAAEAAAAAAAAAi47jAP///wgAAAAAAAAAAAAAAAAAAAAAAAAAAAAAAAAAAAAAeAAAAAEAAABAAAAAAAAAAAAAAABaAAAAAAAAAAAAAAAAAAAAAAAAAAAAAAAAAAAAAAAAAAAAAAAAAAAAAAAAAAAAAAAAAAAAAAAAAAAAAAAAAAAAAAAAAAAAAAAAAAAAFAAAADwAAAAAAAAAAAAAAAAAAAkUAAAAAQAAABQAAAAUAAAAFAAAAAEAAAAAAAAAZAAAAGQAAAAAAAAAZAAAAGQAAAAVAAAAYAAAAAAAAAAAAAAADwAAACADAAAAAAAAAAAAAAEAAACgMgAAVgcAAKr4//8BAAAAf39/AAEAAABkAAAAAAAAABQAAABAHwAAAAAAACYAAAAAAAAAwOD//wAAAAAmAAAAZAAAABYAAABMAAAAAAAAAAAAAAAEAAAAAAAAAAEAAABZWVkKAAAAACgAAAAoAAAAZAAAAGQAAAAAAAAAzMzMAAAAAABQAAAAUAAAAGQAAABkAAAAAAAAABcAAAAUAAAAAAAAAAAAAAD/fwAA/38AAAAAAAAJAAAABAAAAE554FYeAAAAaAAAAAAAAAAAAAAAAAAAAAAAAAAAAAAAECcAABAnAAAAAAAAAAAAAAAAAAAAAAAAAAAAAAAAAAAAAAAAAAAAABQAAAAAAAAAwMD/AAAAAABkAAAAMgAAAAAAAABkAAAAAAAAAH9/fwAKAAAAIgAAABgAAAAAAAAAAAAAAAAAAAAAAAAAAAAAAAAAAAAkAAAAJAAAAAAAAAAHAAAAAAAAAAAAAAAAAAAAAAAAAAAAAAAAAAAAf39/ACUAAABYAAAAAAAAAAAAAAAAAAAAAAAAAAAAAAAAAAAAAAAAAAAAAAAAAAAAAAAAAAAAAAA/AAAAAAAAAKCGAQAAAAAAAAAAAAAAAAAMAAAAAQAAAAAAAAAAAAAAAAAAAB8AAABUAAAAi47jAP///wEAAAAAAAAAAAAAAAAAAAAAAAAAAAAAAAAAAAAAAAAAAAAAAAJ/f38AWVlZA8zMzADAwP8Af39/AAAAAAAAAAAAAAAAAAAAAAAAAAAAIQAAABgAAAAUAAAAMAQAAAQTAAADGQAAGhYAABAAAAAmAAAACAAAAP//////////"/>
               </a:ext>
             </a:extLst>
           </p:cNvSpPr>
@@ -11633,7 +11285,7 @@
           <p:cNvSpPr>
             <a:extLst>
               <a:ext uri="smNativeData">
-                <pr:smNativeData xmlns:pr="smNativeData" xmlns="smNativeData" val="SMDATA_15_EkJ5ZhMAAAAlAAAAZQAAAA0AAAAAqQEAAJAAAACpAQAAkAAAAAAAAAABAAAAAAAAAAEAAABQAAAAhbacS3FV1T8AAAAAAADwvwAAAAAAAOA/AAAAAAAA4D8AAAAAAADgPwAAAAAAAOA/AAAAAAAA4D8AAAAAAADgPwAAAAAAAOA/AAAAAAAA4D8CAAAAjAAAAAEAAAAAAAAAi47jAP///wgAAAAAAAAAAAAAAAAAAAAAAAAAAAAAAAAAAAAAeAAAAAEAAABAAAAAAAAAAAAAAABaAAAAAAAAAAAAAAAAAAAAAAAAAAAAAAAAAAAAAAAAAAAAAAAAAAAAAAAAAAAAAAAAAAAAAAAAAAAAAAAAAAAAAAAAAAAAAAAAAAAAFAAAADwAAAAAAAAAAAAAAAAAAAkUAAAAAQAAABQAAAAUAAAAFAAAAAEAAAAAAAAAZAAAAGQAAAAAAAAAZAAAAGQAAAAVAAAAYAAAAAAAAAAAAAAADwAAACADAAAAAAAAAAAAAAEAAACgMgAAVgcAAKr4//8BAAAAf39/AAEAAABkAAAAAAAAABQAAABAHwAAAAAAACYAAAAAAAAAwOD//wAAAAAmAAAAZAAAABYAAABMAAAAAAAAAAAAAAAEAAAAAAAAAAEAAABZWVkKAAAAACgAAAAoAAAAZAAAAGQAAAAAAAAAzMzMAAAAAABQAAAAUAAAAGQAAABkAAAAAAAAABcAAAAUAAAAAAAAAAAAAAD/fwAA/38AAAAAAAAJAAAABAAAAARNBpkeAAAAaAAAAAAAAAAAAAAAAAAAAAAAAAAAAAAAECcAABAnAAAAAAAAAAAAAAAAAAAAAAAAAAAAAAAAAAAAAAAAAAAAABQAAAAAAAAAwMD/AAAAAABkAAAAMgAAAAAAAABkAAAAAAAAAH9/fwAKAAAAIgAAABgAAAAAAAAAAAAAAAAAAAAAAAAAAAAAAAAAAAAkAAAAJAAAAAAAAAAHAAAAAAAAAAAAAAAAAAAAAAAAAAAAAAAAAAAAf39/ACUAAABYAAAAAAAAAAAAAAAAAAAAAAAAAAAAAAAAAAAAAAAAAAAAAAAAAAAAAAAAAAAAAAA/AAAAAAAAAKCGAQAAAAAAAAAAAAAAAAAMAAAAAQAAAAAAAAAAAAAAAAAAAB8AAABUAAAAi47jAP///wEAAAAAAAAAAAAAAAAAAAAAAAAAAAAAAAAAAAAAAAAAAAAAAAJ/f38AWVlZA8zMzADAwP8Af39/AAAAAAAAAAAAAAAAAAAAAAAAAAAAIQAAABgAAAAUAAAAMAQAACoYAAADGQAAQBsAABAAAAAmAAAACAAAAP//////////"/>
+                <pr:smNativeData xmlns:pr="smNativeData" xmlns="smNativeData" val="SMDATA_15_LkR5ZhMAAAAlAAAAZQAAAA0AAAAAqQEAAJAAAACpAQAAkAAAAAAAAAABAAAAAAAAAAEAAABQAAAAhbacS3FV1T8AAAAAAAAAAAAAAAAAAOA/AAAAAAAA4D8AAAAAAADgPwAAAAAAAOA/AAAAAAAA4D8AAAAAAADgPwAAAAAAAOA/AAAAAAAA4D8CAAAAjAAAAAEAAAAAAAAAi47jAP///wgAAAAAAAAAAAAAAAAAAAAAAAAAAAAAAAAAAAAAeAAAAAEAAABAAAAAAAAAAAAAAABaAAAAAAAAAAAAAAAAAAAAAAAAAAAAAAAAAAAAAAAAAAAAAAAAAAAAAAAAAAAAAAAAAAAAAAAAAAAAAAAAAAAAAAAAAAAAAAAAAAAAFAAAADwAAAAAAAAAAAAAAAAAAAkUAAAAAQAAABQAAAAUAAAAFAAAAAEAAAAAAAAAZAAAAGQAAAAAAAAAZAAAAGQAAAAVAAAAYAAAAAAAAAAAAAAADwAAACADAAAAAAAAAAAAAAEAAACgMgAAVgcAAKr4//8BAAAAf39/AAEAAABkAAAAAAAAABQAAABAHwAAAAAAACYAAAAAAAAAwOD//wAAAAAmAAAAZAAAABYAAABMAAAAAAAAAAAAAAAEAAAAAAAAAAEAAABZWVkKAAAAACgAAAAoAAAAZAAAAGQAAAAAAAAAzMzMAAAAAABQAAAAUAAAAGQAAABkAAAAAAAAABcAAAAUAAAAAAAAAAAAAAD/fwAA/38AAAAAAAAJAAAABAAAAARNBpkeAAAAaAAAAAAAAAAAAAAAAAAAAAAAAAAAAAAAECcAABAnAAAAAAAAAAAAAAAAAAAAAAAAAAAAAAAAAAAAAAAAAAAAABQAAAAAAAAAwMD/AAAAAABkAAAAMgAAAAAAAABkAAAAAAAAAH9/fwAKAAAAIgAAABgAAAAAAAAAAAAAAAAAAAAAAAAAAAAAAAAAAAAkAAAAJAAAAAAAAAAHAAAAAAAAAAAAAAAAAAAAAAAAAAAAAAAAAAAAf39/ACUAAABYAAAAAAAAAAAAAAAAAAAAAAAAAAAAAAAAAAAAAAAAAAAAAAAAAAAAAAAAAAAAAAA/AAAAAAAAAKCGAQAAAAAAAAAAAAAAAAAMAAAAAQAAAAAAAAAAAAAAAAAAAB8AAABUAAAAi47jAP///wEAAAAAAAAAAAAAAAAAAAAAAAAAAAAAAAAAAAAAAAAAAAAAAAJ/f38AWVlZA8zMzADAwP8Af39/AAAAAAAAAAAAAAAAAAAAAAAAAAAAIQAAABgAAAAUAAAAMAQAACoYAAADGQAAQBsAABAAAAAmAAAACAAAAP//////////"/>
               </a:ext>
             </a:extLst>
           </p:cNvSpPr>
@@ -11698,7 +11350,7 @@
           <p:cNvSpPr>
             <a:extLst>
               <a:ext uri="smNativeData">
-                <pr:smNativeData xmlns:pr="smNativeData" xmlns="smNativeData" val="SMDATA_15_EkJ5ZhMAAAAlAAAAZQAAAA0AAAAAqQEAAJAAAACpAQAAkAAAAAAAAAABAAAAAAAAAAEAAABQAAAAhbacS3FV1T8AAAAAAADwvwAAAAAAAOA/AAAAAAAA4D8AAAAAAADgPwAAAAAAAOA/AAAAAAAA4D8AAAAAAADgPwAAAAAAAOA/AAAAAAAA4D8CAAAAjAAAAAEAAAAAAAAAi47jAP///wgAAAAAAAAAAAAAAAAAAAAAAAAAAAAAAAAAAAAAeAAAAAEAAABAAAAAAAAAAAAAAABaAAAAAAAAAAAAAAAAAAAAAAAAAAAAAAAAAAAAAAAAAAAAAAAAAAAAAAAAAAAAAAAAAAAAAAAAAAAAAAAAAAAAAAAAAAAAAAAAAAAAFAAAADwAAAAAAAAAAAAAAAAAAAkUAAAAAQAAABQAAAAUAAAAFAAAAAEAAAAAAAAAZAAAAGQAAAAAAAAAZAAAAGQAAAAVAAAAYAAAAAAAAAAAAAAADwAAACADAAAAAAAAAAAAAAEAAACgMgAAVgcAAKr4//8BAAAAf39/AAEAAABkAAAAAAAAABQAAABAHwAAAAAAACYAAAAAAAAAwOD//wAAAAAmAAAAZAAAABYAAABMAAAAAAAAAAAAAAAEAAAAAAAAAAEAAABZWVkKAAAAACgAAAAoAAAAZAAAAGQAAAAAAAAAzMzMAAAAAABQAAAAUAAAAGQAAABkAAAAAAAAABcAAAAUAAAAAAAAAAAAAAD/fwAA/38AAAAAAAAJAAAABAAAAFQBpU4eAAAAaAAAAAAAAAAAAAAAAAAAAAAAAAAAAAAAECcAABAnAAAAAAAAAAAAAAAAAAAAAAAAAAAAAAAAAAAAAAAAAAAAABQAAAAAAAAAwMD/AAAAAABkAAAAMgAAAAAAAABkAAAAAAAAAH9/fwAKAAAAIgAAABgAAAAAAAAAAAAAAAAAAAAAAAAAAAAAAAAAAAAkAAAAJAAAAAAAAAAHAAAAAAAAAAAAAAAAAAAAAAAAAAAAAAAAAAAAf39/ACUAAABYAAAAAAAAAAAAAAAAAAAAAAAAAAAAAAAAAAAAAAAAAAAAAAAAAAAAAAAAAAAAAAA/AAAAAAAAAKCGAQAAAAAAAAAAAAAAAAAMAAAAAQAAAAAAAAAAAAAAAAAAAB8AAABUAAAAi47jAP///wEAAAAAAAAAAAAAAAAAAAAAAAAAAAAAAAAAAAAAAAAAAAAAAAJ/f38AWVlZA8zMzADAwP8Af39/AAAAAAAAAAAAAAAAAAAAAAAAAAAAIQAAABgAAAAUAAAAMAQAAPkcAAADGQAADyAAABAAAAAmAAAACAAAAP//////////"/>
+                <pr:smNativeData xmlns:pr="smNativeData" xmlns="smNativeData" val="SMDATA_15_LkR5ZhMAAAAlAAAAZQAAAA0AAAAAqQEAAJAAAACpAQAAkAAAAAAAAAABAAAAAAAAAAEAAABQAAAAhbacS3FV1T8AAAAAAAAAAAAAAAAAAOA/AAAAAAAA4D8AAAAAAADgPwAAAAAAAOA/AAAAAAAA4D8AAAAAAADgPwAAAAAAAOA/AAAAAAAA4D8CAAAAjAAAAAEAAAAAAAAAi47jAP///wgAAAAAAAAAAAAAAAAAAAAAAAAAAAAAAAAAAAAAeAAAAAEAAABAAAAAAAAAAAAAAABaAAAAAAAAAAAAAAAAAAAAAAAAAAAAAAAAAAAAAAAAAAAAAAAAAAAAAAAAAAAAAAAAAAAAAAAAAAAAAAAAAAAAAAAAAAAAAAAAAAAAFAAAADwAAAAAAAAAAAAAAAAAAAkUAAAAAQAAABQAAAAUAAAAFAAAAAEAAAAAAAAAZAAAAGQAAAAAAAAAZAAAAGQAAAAVAAAAYAAAAAAAAAAAAAAADwAAACADAAAAAAAAAAAAAAEAAACgMgAAVgcAAKr4//8BAAAAf39/AAEAAABkAAAAAAAAABQAAABAHwAAAAAAACYAAAAAAAAAwOD//wAAAAAmAAAAZAAAABYAAABMAAAAAAAAAAAAAAAEAAAAAAAAAAEAAABZWVkKAAAAACgAAAAoAAAAZAAAAGQAAAAAAAAAzMzMAAAAAABQAAAAUAAAAGQAAABkAAAAAAAAABcAAAAUAAAAAAAAAAAAAAD/fwAA/38AAAAAAAAJAAAABAAAAFQBpU4eAAAAaAAAAAAAAAAAAAAAAAAAAAAAAAAAAAAAECcAABAnAAAAAAAAAAAAAAAAAAAAAAAAAAAAAAAAAAAAAAAAAAAAABQAAAAAAAAAwMD/AAAAAABkAAAAMgAAAAAAAABkAAAAAAAAAH9/fwAKAAAAIgAAABgAAAAAAAAAAAAAAAAAAAAAAAAAAAAAAAAAAAAkAAAAJAAAAAAAAAAHAAAAAAAAAAAAAAAAAAAAAAAAAAAAAAAAAAAAf39/ACUAAABYAAAAAAAAAAAAAAAAAAAAAAAAAAAAAAAAAAAAAAAAAAAAAAAAAAAAAAAAAAAAAAA/AAAAAAAAAKCGAQAAAAAAAAAAAAAAAAAMAAAAAQAAAAAAAAAAAAAAAAAAAB8AAABUAAAAi47jAP///wEAAAAAAAAAAAAAAAAAAAAAAAAAAAAAAAAAAAAAAAAAAAAAAAJ/f38AWVlZA8zMzADAwP8Af39/AAAAAAAAAAAAAAAAAAAAAAAAAAAAIQAAABgAAAAUAAAAMAQAAPkcAAADGQAADyAAABAAAAAmAAAACAAAAP//////////"/>
               </a:ext>
             </a:extLst>
           </p:cNvSpPr>
@@ -11763,7 +11415,7 @@
           <p:cNvSpPr>
             <a:extLst>
               <a:ext uri="smNativeData">
-                <pr:smNativeData xmlns:pr="smNativeData" xmlns="smNativeData" val="SMDATA_15_EkJ5ZhMAAAAlAAAAZQAAAA0AAAAAqQEAAJAAAACpAQAAkAAAAAAAAAABAAAAAAAAAAEAAABQAAAAhbacS3FV1T8AAAAAAADwvwAAAAAAAOA/AAAAAAAA4D8AAAAAAADgPwAAAAAAAOA/AAAAAAAA4D8AAAAAAADgPwAAAAAAAOA/AAAAAAAA4D8CAAAAjAAAAAEAAAAAAAAAi47jAP///wgAAAAAAAAAAAAAAAAAAAAAAAAAAAAAAAAAAAAAeAAAAAEAAABAAAAAAAAAAAAAAABaAAAAAAAAAAAAAAAAAAAAAAAAAAAAAAAAAAAAAAAAAAAAAAAAAAAAAAAAAAAAAAAAAAAAAAAAAAAAAAAAAAAAAAAAAAAAAAAAAAAAFAAAADwAAAAAAAAAAAAAAAAAAAkUAAAAAQAAABQAAAAUAAAAFAAAAAEAAAAAAAAAZAAAAGQAAAAAAAAAZAAAAGQAAAAVAAAAYAAAAAAAAAAAAAAADwAAACADAAAAAAAAAAAAAAEAAACgMgAAVgcAAKr4//8BAAAAf39/AAEAAABkAAAAAAAAABQAAABAHwAAAAAAACYAAAAAAAAAwOD//wAAAAAmAAAAZAAAABYAAABMAAAAAAAAAAAAAAAEAAAAAAAAAAEAAABZWVkKAAAAACgAAAAoAAAAZAAAAGQAAAAAAAAAzMzMAAAAAABQAAAAUAAAAGQAAABkAAAAAAAAABcAAAAUAAAAAAAAAAAAAAD/fwAA/38AAAAAAAAJAAAABAAAACOg4r4eAAAAaAAAAAAAAAAAAAAAAAAAAAAAAAAAAAAAECcAABAnAAAAAAAAAAAAAAAAAAAAAAAAAAAAAAAAAAAAAAAAAAAAABQAAAAAAAAAwMD/AAAAAABkAAAAMgAAAAAAAABkAAAAAAAAAH9/fwAKAAAAIgAAABgAAAAAAAAAAAAAAAAAAAAAAAAAAAAAAAAAAAAkAAAAJAAAAAAAAAAHAAAAAAAAAAAAAAAAAAAAAAAAAAAAAAAAAAAAf39/ACUAAABYAAAAAAAAAAAAAAAAAAAAAAAAAAAAAAAAAAAAAAAAAAAAAAAAAAAAAAAAAAAAAAA/AAAAAAAAAKCGAQAAAAAAAAAAAAAAAAAMAAAAAQAAAAAAAAAAAAAAAAAAAB8AAABUAAAAi47jAP///wEAAAAAAAAAAAAAAAAAAAAAAAAAAAAAAAAAAAAAAAAAAAAAAAJ/f38AWVlZA8zMzADAwP8Af39/AAAAAAAAAAAAAAAAAAAAAAAAAAAAIQAAABgAAAAUAAAAMAQAAMkhAAADGQAA3yQAABAAAAAmAAAACAAAAP//////////"/>
+                <pr:smNativeData xmlns:pr="smNativeData" xmlns="smNativeData" val="SMDATA_15_LkR5ZhMAAAAlAAAAZQAAAA0AAAAAqQEAAJAAAACpAQAAkAAAAAAAAAABAAAAAAAAAAEAAABQAAAAhbacS3FV1T8AAAAAAAAAAAAAAAAAAOA/AAAAAAAA4D8AAAAAAADgPwAAAAAAAOA/AAAAAAAA4D8AAAAAAADgPwAAAAAAAOA/AAAAAAAA4D8CAAAAjAAAAAEAAAAAAAAAi47jAP///wgAAAAAAAAAAAAAAAAAAAAAAAAAAAAAAAAAAAAAeAAAAAEAAABAAAAAAAAAAAAAAABaAAAAAAAAAAAAAAAAAAAAAAAAAAAAAAAAAAAAAAAAAAAAAAAAAAAAAAAAAAAAAAAAAAAAAAAAAAAAAAAAAAAAAAAAAAAAAAAAAAAAFAAAADwAAAAAAAAAAAAAAAAAAAkUAAAAAQAAABQAAAAUAAAAFAAAAAEAAAAAAAAAZAAAAGQAAAAAAAAAZAAAAGQAAAAVAAAAYAAAAAAAAAAAAAAADwAAACADAAAAAAAAAAAAAAEAAACgMgAAVgcAAKr4//8BAAAAf39/AAEAAABkAAAAAAAAABQAAABAHwAAAAAAACYAAAAAAAAAwOD//wAAAAAmAAAAZAAAABYAAABMAAAAAAAAAAAAAAAEAAAAAAAAAAEAAABZWVkKAAAAACgAAAAoAAAAZAAAAGQAAAAAAAAAzMzMAAAAAABQAAAAUAAAAGQAAABkAAAAAAAAABcAAAAUAAAAAAAAAAAAAAD/fwAA/38AAAAAAAAJAAAABAAAACOg4r4eAAAAaAAAAAAAAAAAAAAAAAAAAAAAAAAAAAAAECcAABAnAAAAAAAAAAAAAAAAAAAAAAAAAAAAAAAAAAAAAAAAAAAAABQAAAAAAAAAwMD/AAAAAABkAAAAMgAAAAAAAABkAAAAAAAAAH9/fwAKAAAAIgAAABgAAAAAAAAAAAAAAAAAAAAAAAAAAAAAAAAAAAAkAAAAJAAAAAAAAAAHAAAAAAAAAAAAAAAAAAAAAAAAAAAAAAAAAAAAf39/ACUAAABYAAAAAAAAAAAAAAAAAAAAAAAAAAAAAAAAAAAAAAAAAAAAAAAAAAAAAAAAAAAAAAA/AAAAAAAAAKCGAQAAAAAAAAAAAAAAAAAMAAAAAQAAAAAAAAAAAAAAAAAAAB8AAABUAAAAi47jAP///wEAAAAAAAAAAAAAAAAAAAAAAAAAAAAAAAAAAAAAAAAAAAAAAAJ/f38AWVlZA8zMzADAwP8Af39/AAAAAAAAAAAAAAAAAAAAAAAAAAAAIQAAABgAAAAUAAAAMAQAAMkhAAADGQAA3yQAABAAAAAmAAAACAAAAP//////////"/>
               </a:ext>
             </a:extLst>
           </p:cNvSpPr>
@@ -11830,7 +11482,7 @@
             <a:endCxn id="4" idx="1"/>
             <a:extLst>
               <a:ext uri="smNativeData">
-                <pr:smNativeData xmlns:pr="smNativeData" xmlns="smNativeData" val="SMDATA_15_EkJ5ZhMAAAAlAAAADwAAAA0AAAAAkAAAAEgAAACQAAAASAAAAAAAAAAAAAAAAAAAAAEAAABQAAAAAAAAAADWiMAAAAAAAAAAAAAAAAAAAPA/AAAAAAAA4D8AAAAAAADgPwAAAAAAAOA/AAAAAAAA4D8AAAAAAADgPwAAAAAAAOA/AAAAAAAA4D8CAAAAjAAAAAAAAAAAAAAAQoX0DP///wgAAAAAAAAAAAAAAAAAAAAAAAAAAAAAAAAAAAAAZAAAAAEAAABAAAAAAAAAAAAAAAAAAAAAAAAAAAAAAAAAAAAAAAAAAAAAAAAAAAAAAAAAAAAAAAAAAAAAAAAAAAAAAAAAAAAAAAAAAAAAAAAAAAAAAAAAAAAAAAAAAAAAFAAAADwAAAABAAAAAwAAAAE9hQAeAAAAAQAAACMAAAAjAAAAIwAAAB4AAAAAAAAAZAAAAGQAAAAAAAAAZAAAAGQAAAAVAAAAYAAAAAAAAAAAAAAADwAAACADAAAAAAAAAAAAAAEAAACgMgAAVgcAAKr4//8BAAAAf39/AAEAAABkAAAAAAAAABQAAABAHwAAAAAAACYAAAAAAAAAwOD//wAAAAAmAAAAZAAAABYAAABMAAAAAAAAAAAAAAAEAAAAAAAAAAEAAABZWVkKAAAAACgAAAAoAAAAZAAAAGQAAAAAAAAAzMzMAAAAAABQAAAAUAAAAGQAAABkAAAAAAAAABcAAAAUAAAAAAAAAAAAAAD/fwAA/38AAAAAAAAJAAAABAAAAMkMAAAeAAAAaAAAAAAAAAAAAAAAAAAAAAAAAAAAAAAAECcAABAnAAAAAAAAAAAAAAAAAAAAAAAAAAAAAAAAAAAAAAAAAAAAABQAAAAAAAAAwMD/AAAAAABkAAAAMgAAAAAAAABkAAAAAAAAAH9/fwAKAAAAIgAAABgAAAAAAAAAAAAAAAAAAAAAAAAAAAAAAAAAAAAkAAAAJAAAAAAAAAAHAAAAAAAAAAAAAAAAAAAAAAAAAAAAAAAAAAAAf39/ACUAAABYAAAAAAAAAAAAAAAAAAAAAAAAAAAAAAAAAAAAAAAAAAAAAAAAAAAAAAAAAAAAAAA/AAAAAAAAAKCGAQAAAAAAAAAAAAAAAAAMAAAAAQAAAAAAAAAAAAAAAAAAAB8AAABUAAAAQoX0Bf///wEAAAAAAAAAAAAAAAAAAAAAAAAAAAAAAAAAAAAAAAAAAAE9hQB/f38AWVlZA8zMzADAwP8Af39/AAAAAAAAAAAAAAAAAAAAAAAAAAAAIQAAABgAAAAUAAAAMAQAAFgKAAAwBAAAaQ8AABAAAAAmAAAACAAAAP//////////"/>
+                <pr:smNativeData xmlns:pr="smNativeData" xmlns="smNativeData" val="SMDATA_15_LkR5ZhMAAAAlAAAADwAAAA0AAAAAkAAAAEgAAACQAAAASAAAAAAAAAAAAAAAAAAAAAEAAABQAAAAAAAAAADWiMAAAAAAAAAAAAAAAAAAAPA/AAAAAAAA4D8AAAAAAADgPwAAAAAAAOA/AAAAAAAA4D8AAAAAAADgPwAAAAAAAOA/AAAAAAAA4D8CAAAAjAAAAAAAAAAAAAAAQoX0DP///wgAAAAAAAAAAAAAAAAAAAAAAAAAAAAAAAAAAAAAZAAAAAEAAABAAAAAAAAAAAAAAAAAAAAAAAAAAAAAAAAAAAAAAAAAAAAAAAAAAAAAAAAAAAAAAAAAAAAAAAAAAAAAAAAAAAAAAAAAAAAAAAAAAAAAAAAAAAAAAAAAAAAAFAAAADwAAAABAAAAAwAAAAE9hQAeAAAAAQAAACMAAAAjAAAAIwAAAB4AAAAAAAAAZAAAAGQAAAAAAAAAZAAAAGQAAAAVAAAAYAAAAAAAAAAAAAAADwAAACADAAAAAAAAAAAAAAEAAACgMgAAVgcAAKr4//8BAAAAf39/AAEAAABkAAAAAAAAABQAAABAHwAAAAAAACYAAAAAAAAAwOD//wAAAAAmAAAAZAAAABYAAABMAAAAAAAAAAAAAAAEAAAAAAAAAAEAAABZWVkKAAAAACgAAAAoAAAAZAAAAGQAAAAAAAAAzMzMAAAAAABQAAAAUAAAAGQAAABkAAAAAAAAABcAAAAUAAAAAAAAAAAAAAD/fwAA/38AAAAAAAAJAAAABAAAAMkMAAAeAAAAaAAAAAAAAAAAAAAAAAAAAAAAAAAAAAAAECcAABAnAAAAAAAAAAAAAAAAAAAAAAAAAAAAAAAAAAAAAAAAAAAAABQAAAAAAAAAwMD/AAAAAABkAAAAMgAAAAAAAABkAAAAAAAAAH9/fwAKAAAAIgAAABgAAAAAAAAAAAAAAAAAAAAAAAAAAAAAAAAAAAAkAAAAJAAAAAAAAAAHAAAAAAAAAAAAAAAAAAAAAAAAAAAAAAAAAAAAf39/ACUAAABYAAAAAAAAAAAAAAAAAAAAAAAAAAAAAAAAAAAAAAAAAAAAAAAAAAAAAAAAAAAAAAA/AAAAAAAAAKCGAQAAAAAAAAAAAAAAAAAMAAAAAQAAAAAAAAAAAAAAAAAAAB8AAABUAAAAQoX0Bf///wEAAAAAAAAAAAAAAAAAAAAAAAAAAAAAAAAAAAAAAAAAAAE9hQB/f38AWVlZA8zMzADAwP8Af39/AAAAAAAAAAAAAAAAAAAAAAAAAAAAIQAAABgAAAAUAAAAMAQAAFgKAAAwBAAAaQ8AABAAAAAmAAAACAAAAP//////////"/>
               </a:ext>
             </a:extLst>
           </p:cNvCxnSpPr>
@@ -11866,7 +11518,7 @@
             <a:endCxn id="5" idx="1"/>
             <a:extLst>
               <a:ext uri="smNativeData">
-                <pr:smNativeData xmlns:pr="smNativeData" xmlns="smNativeData" val="SMDATA_15_EkJ5ZhMAAAAlAAAADwAAAA0AAAAAkAAAAEgAAACQAAAASAAAAAAAAAAAAAAAAAAAAAEAAABQAAAAAAAAAADWiMAAAAAAAAAAAAAAAAAAAPA/AAAAAAAA4D8AAAAAAADgPwAAAAAAAOA/AAAAAAAA4D8AAAAAAADgPwAAAAAAAOA/AAAAAAAA4D8CAAAAjAAAAAAAAAAAAAAAQoX0DP///wgAAAAAAAAAAAAAAAAAAAAAAAAAAAAAAAAAAAAAZAAAAAEAAABAAAAAAAAAAAAAAAAAAAAAAAAAAAAAAAAAAAAAAAAAAAAAAAAAAAAAAAAAAAAAAAAAAAAAAAAAAAAAAAAAAAAAAAAAAAAAAAAAAAAAAAAAAAAAAAAAAAAAFAAAADwAAAABAAAAAwAAAAE9hQAeAAAAAQAAACMAAAAjAAAAIwAAAB4AAAAAAAAAZAAAAGQAAAAAAAAAZAAAAGQAAAAVAAAAYAAAAAAAAAAAAAAADwAAACADAAAAAAAAAAAAAAEAAACgMgAAVgcAAKr4//8BAAAAf39/AAEAAABkAAAAAAAAABQAAABAHwAAAAAAACYAAAAAAAAAwOD//wAAAAAmAAAAZAAAABYAAABMAAAAAAAAAAAAAAAEAAAAAAAAAAEAAABZWVkKAAAAACgAAAAoAAAAZAAAAGQAAAAAAAAAzMzMAAAAAABQAAAAUAAAAGQAAABkAAAAAAAAABcAAAAUAAAAAAAAAAAAAAD/fwAA/38AAAAAAAAJAAAABAAAAAAAAAAeAAAAaAAAAAAAAAAAAAAAAAAAAAAAAAAAAAAAECcAABAnAAAAAAAAAAAAAAAAAAAAAAAAAAAAAAAAAAAAAAAAAAAAABQAAAAAAAAAwMD/AAAAAABkAAAAMgAAAAAAAABkAAAAAAAAAH9/fwAKAAAAIgAAABgAAAAAAAAAAAAAAAAAAAAAAAAAAAAAAAAAAAAkAAAAJAAAAAAAAAAHAAAAAAAAAAAAAAAAAAAAAAAAAAAAAAAAAAAAf39/ACUAAABYAAAAAAAAAAAAAAAAAAAAAAAAAAAAAAAAAAAAAAAAAAAAAAAAAAAAAAAAAAAAAAA/AAAAAAAAAKCGAQAAAAAAAAAAAAAAAAAMAAAAAQAAAAAAAAAAAAAAAAAAAB8AAABUAAAAQoX0Bf///wEAAAAAAAAAAAAAAAAAAAAAAAAAAAAAAAAAAAAAAAAAAAE9hQB/f38AWVlZA8zMzADAwP8Af39/AAAAAAAAAAAAAAAAAAAAAAAAAAAAIQAAABgAAAAUAAAAMAQAAGkPAAAwBAAAjxQAABAAAAAmAAAACAAAAP//////////"/>
+                <pr:smNativeData xmlns:pr="smNativeData" xmlns="smNativeData" val="SMDATA_15_LkR5ZhMAAAAlAAAADwAAAA0AAAAAkAAAAEgAAACQAAAASAAAAAAAAAAAAAAAAAAAAAEAAABQAAAAAAAAAADWiMAAAAAAAAAAAAAAAAAAAPA/AAAAAAAA4D8AAAAAAADgPwAAAAAAAOA/AAAAAAAA4D8AAAAAAADgPwAAAAAAAOA/AAAAAAAA4D8CAAAAjAAAAAAAAAAAAAAAQoX0DP///wgAAAAAAAAAAAAAAAAAAAAAAAAAAAAAAAAAAAAAZAAAAAEAAABAAAAAAAAAAAAAAAAAAAAAAAAAAAAAAAAAAAAAAAAAAAAAAAAAAAAAAAAAAAAAAAAAAAAAAAAAAAAAAAAAAAAAAAAAAAAAAAAAAAAAAAAAAAAAAAAAAAAAFAAAADwAAAABAAAAAwAAAAE9hQAeAAAAAQAAACMAAAAjAAAAIwAAAB4AAAAAAAAAZAAAAGQAAAAAAAAAZAAAAGQAAAAVAAAAYAAAAAAAAAAAAAAADwAAACADAAAAAAAAAAAAAAEAAACgMgAAVgcAAKr4//8BAAAAf39/AAEAAABkAAAAAAAAABQAAABAHwAAAAAAACYAAAAAAAAAwOD//wAAAAAmAAAAZAAAABYAAABMAAAAAAAAAAAAAAAEAAAAAAAAAAEAAABZWVkKAAAAACgAAAAoAAAAZAAAAGQAAAAAAAAAzMzMAAAAAABQAAAAUAAAAGQAAABkAAAAAAAAABcAAAAUAAAAAAAAAAAAAAD/fwAA/38AAAAAAAAJAAAABAAAAAAAAAAeAAAAaAAAAAAAAAAAAAAAAAAAAAAAAAAAAAAAECcAABAnAAAAAAAAAAAAAAAAAAAAAAAAAAAAAAAAAAAAAAAAAAAAABQAAAAAAAAAwMD/AAAAAABkAAAAMgAAAAAAAABkAAAAAAAAAH9/fwAKAAAAIgAAABgAAAAAAAAAAAAAAAAAAAAAAAAAAAAAAAAAAAAkAAAAJAAAAAAAAAAHAAAAAAAAAAAAAAAAAAAAAAAAAAAAAAAAAAAAf39/ACUAAABYAAAAAAAAAAAAAAAAAAAAAAAAAAAAAAAAAAAAAAAAAAAAAAAAAAAAAAAAAAAAAAA/AAAAAAAAAKCGAQAAAAAAAAAAAAAAAAAMAAAAAQAAAAAAAAAAAAAAAAAAAB8AAABUAAAAQoX0Bf///wEAAAAAAAAAAAAAAAAAAAAAAAAAAAAAAAAAAAAAAAAAAAE9hQB/f38AWVlZA8zMzADAwP8Af39/AAAAAAAAAAAAAAAAAAAAAAAAAAAAIQAAABgAAAAUAAAAMAQAAGkPAAAwBAAAjxQAABAAAAAmAAAACAAAAP//////////"/>
               </a:ext>
             </a:extLst>
           </p:cNvCxnSpPr>
@@ -11902,7 +11554,7 @@
             <a:endCxn id="6" idx="1"/>
             <a:extLst>
               <a:ext uri="smNativeData">
-                <pr:smNativeData xmlns:pr="smNativeData" xmlns="smNativeData" val="SMDATA_15_EkJ5ZhMAAAAlAAAADwAAAA0AAAAAkAAAAEgAAACQAAAASAAAAAAAAAAAAAAAAAAAAAEAAABQAAAAAAAAAADWiMAAAAAAAAAAAAAAAAAAAPA/AAAAAAAA4D8AAAAAAADgPwAAAAAAAOA/AAAAAAAA4D8AAAAAAADgPwAAAAAAAOA/AAAAAAAA4D8CAAAAjAAAAAAAAAAAAAAAQoX0DP///wgAAAAAAAAAAAAAAAAAAAAAAAAAAAAAAAAAAAAAZAAAAAEAAABAAAAAAAAAAAAAAAAAAAAAAAAAAAAAAAAAAAAAAAAAAAAAAAAAAAAAAAAAAAAAAAAAAAAAAAAAAAAAAAAAAAAAAAAAAAAAAAAAAAAAAAAAAAAAAAAAAAAAFAAAADwAAAABAAAAAwAAAAE9hQAeAAAAAQAAACMAAAAjAAAAIwAAAB4AAAAAAAAAZAAAAGQAAAAAAAAAZAAAAGQAAAAVAAAAYAAAAAAAAAAAAAAADwAAACADAAAAAAAAAAAAAAEAAACgMgAAVgcAAKr4//8BAAAAf39/AAEAAABkAAAAAAAAABQAAABAHwAAAAAAACYAAAAAAAAAwOD//wAAAAAmAAAAZAAAABYAAABMAAAAAAAAAAAAAAAEAAAAAAAAAAEAAABZWVkKAAAAACgAAAAoAAAAZAAAAGQAAAAAAAAAzMzMAAAAAABQAAAAUAAAAGQAAABkAAAAAAAAABcAAAAUAAAAAAAAAAAAAAD/fwAA/38AAAAAAAAJAAAABAAAAB++y0QeAAAAaAAAAAAAAAAAAAAAAAAAAAAAAAAAAAAAECcAABAnAAAAAAAAAAAAAAAAAAAAAAAAAAAAAAAAAAAAAAAAAAAAABQAAAAAAAAAwMD/AAAAAABkAAAAMgAAAAAAAABkAAAAAAAAAH9/fwAKAAAAIgAAABgAAAAAAAAAAAAAAAAAAAAAAAAAAAAAAAAAAAAkAAAAJAAAAAAAAAAHAAAAAAAAAAAAAAAAAAAAAAAAAAAAAAAAAAAAf39/ACUAAABYAAAAAAAAAAAAAAAAAAAAAAAAAAAAAAAAAAAAAAAAAAAAAAAAAAAAAAAAAAAAAAA/AAAAAAAAAKCGAQAAAAAAAAAAAAAAAAAMAAAAAQAAAAAAAAAAAAAAAAAAAB8AAABUAAAAQoX0Bf///wEAAAAAAAAAAAAAAAAAAAAAAAAAAAAAAAAAAAAAAAAAAAE9hQB/f38AWVlZA8zMzADAwP8Af39/AAAAAAAAAAAAAAAAAAAAAAAAAAAAIQAAABgAAAAUAAAAMAQAAI8UAAAwBAAAtRkAABAAAAAmAAAACAAAAP//////////"/>
+                <pr:smNativeData xmlns:pr="smNativeData" xmlns="smNativeData" val="SMDATA_15_LkR5ZhMAAAAlAAAADwAAAA0AAAAAkAAAAEgAAACQAAAASAAAAAAAAAAAAAAAAAAAAAEAAABQAAAAAAAAAADWiMAAAAAAAAAAAAAAAAAAAPA/AAAAAAAA4D8AAAAAAADgPwAAAAAAAOA/AAAAAAAA4D8AAAAAAADgPwAAAAAAAOA/AAAAAAAA4D8CAAAAjAAAAAAAAAAAAAAAQoX0DP///wgAAAAAAAAAAAAAAAAAAAAAAAAAAAAAAAAAAAAAZAAAAAEAAABAAAAAAAAAAAAAAAAAAAAAAAAAAAAAAAAAAAAAAAAAAAAAAAAAAAAAAAAAAAAAAAAAAAAAAAAAAAAAAAAAAAAAAAAAAAAAAAAAAAAAAAAAAAAAAAAAAAAAFAAAADwAAAABAAAAAwAAAAE9hQAeAAAAAQAAACMAAAAjAAAAIwAAAB4AAAAAAAAAZAAAAGQAAAAAAAAAZAAAAGQAAAAVAAAAYAAAAAAAAAAAAAAADwAAACADAAAAAAAAAAAAAAEAAACgMgAAVgcAAKr4//8BAAAAf39/AAEAAABkAAAAAAAAABQAAABAHwAAAAAAACYAAAAAAAAAwOD//wAAAAAmAAAAZAAAABYAAABMAAAAAAAAAAAAAAAEAAAAAAAAAAEAAABZWVkKAAAAACgAAAAoAAAAZAAAAGQAAAAAAAAAzMzMAAAAAABQAAAAUAAAAGQAAABkAAAAAAAAABcAAAAUAAAAAAAAAAAAAAD/fwAA/38AAAAAAAAJAAAABAAAAB++y0QeAAAAaAAAAAAAAAAAAAAAAAAAAAAAAAAAAAAAECcAABAnAAAAAAAAAAAAAAAAAAAAAAAAAAAAAAAAAAAAAAAAAAAAABQAAAAAAAAAwMD/AAAAAABkAAAAMgAAAAAAAABkAAAAAAAAAH9/fwAKAAAAIgAAABgAAAAAAAAAAAAAAAAAAAAAAAAAAAAAAAAAAAAkAAAAJAAAAAAAAAAHAAAAAAAAAAAAAAAAAAAAAAAAAAAAAAAAAAAAf39/ACUAAABYAAAAAAAAAAAAAAAAAAAAAAAAAAAAAAAAAAAAAAAAAAAAAAAAAAAAAAAAAAAAAAA/AAAAAAAAAKCGAQAAAAAAAAAAAAAAAAAMAAAAAQAAAAAAAAAAAAAAAAAAAB8AAABUAAAAQoX0Bf///wEAAAAAAAAAAAAAAAAAAAAAAAAAAAAAAAAAAAAAAAAAAAE9hQB/f38AWVlZA8zMzADAwP8Af39/AAAAAAAAAAAAAAAAAAAAAAAAAAAAIQAAABgAAAAUAAAAMAQAAI8UAAAwBAAAtRkAABAAAAAmAAAACAAAAP//////////"/>
               </a:ext>
             </a:extLst>
           </p:cNvCxnSpPr>
@@ -11936,7 +11588,7 @@
           <p:cNvCxnSpPr>
             <a:extLst>
               <a:ext uri="smNativeData">
-                <pr:smNativeData xmlns:pr="smNativeData" xmlns="smNativeData" val="SMDATA_15_EkJ5ZhMAAAAlAAAADwAAAA0AAAAAkAAAAEgAAACQAAAASAAAAAAAAAAAAAAAAAAAAAEAAABQAAAAAAAAAADWiMAAAAAAAAAAAAAAAAAAAPA/AAAAAAAA4D8AAAAAAADgPwAAAAAAAOA/AAAAAAAA4D8AAAAAAADgPwAAAAAAAOA/AAAAAAAA4D8CAAAAjAAAAAAAAAAAAAAAQoX0DP///wgAAAAAAAAAAAAAAAAAAAAAAAAAAAAAAAAAAAAAZAAAAAEAAABAAAAAAAAAAAAAAAAAAAAAAAAAAAAAAAAAAAAAAAAAAAAAAAAAAAAAAAAAAAAAAAAAAAAAAAAAAAAAAAAAAAAAAAAAAAAAAAAAAAAAAAAAAAAAAAAAAAAAFAAAADwAAAABAAAAAwAAAAE9hQAeAAAAAQAAACMAAAAjAAAAIwAAAB4AAAAAAAAAZAAAAGQAAAAAAAAAZAAAAGQAAAAVAAAAYAAAAAAAAAAAAAAADwAAACADAAAAAAAAAAAAAAEAAACgMgAAVgcAAKr4//8BAAAAf39/AAEAAABkAAAAAAAAABQAAABAHwAAAAAAACYAAAAAAAAAwOD//wAAAAAmAAAAZAAAABYAAABMAAAAAAAAAAAAAAAEAAAAAAAAAAEAAABZWVkKAAAAACgAAAAoAAAAZAAAAGQAAAAAAAAAzMzMAAAAAABQAAAAUAAAAGQAAABkAAAAAAAAABcAAAAUAAAAAAAAAAAAAAD/fwAA/38AAAAAAAAJAAAABAAAAAAAAAAeAAAAaAAAAAAAAAAAAAAAAAAAAAAAAAAAAAAAECcAABAnAAAAAAAAAAAAAAAAAAAAAAAAAAAAAAAAAAAAAAAAAAAAABQAAAAAAAAAwMD/AAAAAABkAAAAMgAAAAAAAABkAAAAAAAAAH9/fwAKAAAAIgAAABgAAAAAAAAAAAAAAAAAAAAAAAAAAAAAAAAAAAAkAAAAJAAAAAAAAAAHAAAAAAAAAAAAAAAAAAAAAAAAAAAAAAAAAAAAf39/ACUAAABYAAAAAAAAAAAAAAAAAAAAAAAAAAAAAAAAAAAAAAAAAAAAAAAAAAAAAAAAAAAAAAA/AAAAAAAAAKCGAQAAAAAAAAAAAAAAAAAMAAAAAQAAAAAAAAAAAAAAAAAAAB8AAABUAAAAQoX0Bf///wEAAAAAAAAAAAAAAAAAAAAAAAAAAAAAAAAAAAAAAAAAAAE9hQB/f38AWVlZA8zMzADAwP8Af39/AAAAAAAAAAAAAAAAAAAAAAAAAAAAIQAAABgAAAAUAAAAMAQAAPUZAAAxBAAAGx8AABAAAAAmAAAACAAAAP//////////"/>
+                <pr:smNativeData xmlns:pr="smNativeData" xmlns="smNativeData" val="SMDATA_15_LkR5ZhMAAAAlAAAADwAAAA0AAAAAkAAAAEgAAACQAAAASAAAAAAAAAAAAAAAAAAAAAEAAABQAAAAAAAAAADWiMAAAAAAAAAAAAAAAAAAAPA/AAAAAAAA4D8AAAAAAADgPwAAAAAAAOA/AAAAAAAA4D8AAAAAAADgPwAAAAAAAOA/AAAAAAAA4D8CAAAAjAAAAAAAAAAAAAAAQoX0DP///wgAAAAAAAAAAAAAAAAAAAAAAAAAAAAAAAAAAAAAZAAAAAEAAABAAAAAAAAAAAAAAAAAAAAAAAAAAAAAAAAAAAAAAAAAAAAAAAAAAAAAAAAAAAAAAAAAAAAAAAAAAAAAAAAAAAAAAAAAAAAAAAAAAAAAAAAAAAAAAAAAAAAAFAAAADwAAAABAAAAAwAAAAE9hQAeAAAAAQAAACMAAAAjAAAAIwAAAB4AAAAAAAAAZAAAAGQAAAAAAAAAZAAAAGQAAAAVAAAAYAAAAAAAAAAAAAAADwAAACADAAAAAAAAAAAAAAEAAACgMgAAVgcAAKr4//8BAAAAf39/AAEAAABkAAAAAAAAABQAAABAHwAAAAAAACYAAAAAAAAAwOD//wAAAAAmAAAAZAAAABYAAABMAAAAAAAAAAAAAAAEAAAAAAAAAAEAAABZWVkKAAAAACgAAAAoAAAAZAAAAGQAAAAAAAAAzMzMAAAAAABQAAAAUAAAAGQAAABkAAAAAAAAABcAAAAUAAAAAAAAAAAAAAD/fwAA/38AAAAAAAAJAAAABAAAAAAAAAAeAAAAaAAAAAAAAAAAAAAAAAAAAAAAAAAAAAAAECcAABAnAAAAAAAAAAAAAAAAAAAAAAAAAAAAAAAAAAAAAAAAAAAAABQAAAAAAAAAwMD/AAAAAABkAAAAMgAAAAAAAABkAAAAAAAAAH9/fwAKAAAAIgAAABgAAAAAAAAAAAAAAAAAAAAAAAAAAAAAAAAAAAAkAAAAJAAAAAAAAAAHAAAAAAAAAAAAAAAAAAAAAAAAAAAAAAAAAAAAf39/ACUAAABYAAAAAAAAAAAAAAAAAAAAAAAAAAAAAAAAAAAAAAAAAAAAAAAAAAAAAAAAAAAAAAA/AAAAAAAAAKCGAQAAAAAAAAAAAAAAAAAMAAAAAQAAAAAAAAAAAAAAAAAAAB8AAABUAAAAQoX0Bf///wEAAAAAAAAAAAAAAAAAAAAAAAAAAAAAAAAAAAAAAAAAAAE9hQB/f38AWVlZA8zMzADAwP8Af39/AAAAAAAAAAAAAAAAAAAAAAAAAAAAIQAAABgAAAAUAAAAMAQAAPUZAAAxBAAAGx8AABAAAAAmAAAACAAAAP//////////"/>
               </a:ext>
             </a:extLst>
           </p:cNvCxnSpPr>
@@ -11970,7 +11622,7 @@
           <p:cNvCxnSpPr>
             <a:extLst>
               <a:ext uri="smNativeData">
-                <pr:smNativeData xmlns:pr="smNativeData" xmlns="smNativeData" val="SMDATA_15_EkJ5ZhMAAAAlAAAADwAAAA0AAAAAkAAAAEgAAACQAAAASAAAAAAAAAAAAAAAAAAAAAEAAABQAAAAAAAAAADWiMAAAAAAAAAAAAAAAAAAAPA/AAAAAAAA4D8AAAAAAADgPwAAAAAAAOA/AAAAAAAA4D8AAAAAAADgPwAAAAAAAOA/AAAAAAAA4D8CAAAAjAAAAAAAAAAAAAAAQoX0DP///wgAAAAAAAAAAAAAAAAAAAAAAAAAAAAAAAAAAAAAZAAAAAEAAABAAAAAAAAAAAAAAAAAAAAAAAAAAAAAAAAAAAAAAAAAAAAAAAAAAAAAAAAAAAAAAAAAAAAAAAAAAAAAAAAAAAAAAAAAAAAAAAAAAAAAAAAAAAAAAAAAAAAAFAAAADwAAAABAAAAAwAAAAE9hQAeAAAAAQAAACMAAAAjAAAAIwAAAB4AAAAAAAAAZAAAAGQAAAAAAAAAZAAAAGQAAAAVAAAAYAAAAAAAAAAAAAAADwAAACADAAAAAAAAAAAAAAEAAACgMgAAVgcAAKr4//8BAAAAf39/AAEAAABkAAAAAAAAABQAAABAHwAAAAAAACYAAAAAAAAAwOD//wAAAAAmAAAAZAAAABYAAABMAAAAAAAAAAAAAAAEAAAAAAAAAAEAAABZWVkKAAAAACgAAAAoAAAAZAAAAGQAAAAAAAAAzMzMAAAAAABQAAAAUAAAAGQAAABkAAAAAAAAABcAAAAUAAAAAAAAAAAAAAD/fwAA/38AAAAAAAAJAAAABAAAACgAAAAeAAAAaAAAAAAAAAAAAAAAAAAAAAAAAAAAAAAAECcAABAnAAAAAAAAAAAAAAAAAAAAAAAAAAAAAAAAAAAAAAAAAAAAABQAAAAAAAAAwMD/AAAAAABkAAAAMgAAAAAAAABkAAAAAAAAAH9/fwAKAAAAIgAAABgAAAAAAAAAAAAAAAAAAAAAAAAAAAAAAAAAAAAkAAAAJAAAAAAAAAAHAAAAAAAAAAAAAAAAAAAAAAAAAAAAAAAAAAAAf39/ACUAAABYAAAAAAAAAAAAAAAAAAAAAAAAAAAAAAAAAAAAAAAAAAAAAAAAAAAAAAAAAAAAAAA/AAAAAAAAAKCGAQAAAAAAAAAAAAAAAAAMAAAAAQAAAAAAAAAAAAAAAAAAAB8AAABUAAAAQoX0Bf///wEAAAAAAAAAAAAAAAAAAAAAAAAAAAAAAAAAAAAAAAAAAAE9hQB/f38AWVlZA8zMzADAwP8Af39/AAAAAAAAAAAAAAAAAAAAAAAAAAAAIQAAABgAAAAUAAAAMAQAAFofAAAxBAAAgCQAABAAAAAmAAAACAAAAP//////////"/>
+                <pr:smNativeData xmlns:pr="smNativeData" xmlns="smNativeData" val="SMDATA_15_LkR5ZhMAAAAlAAAADwAAAA0AAAAAkAAAAEgAAACQAAAASAAAAAAAAAAAAAAAAAAAAAEAAABQAAAAAAAAAADWiMAAAAAAAAAAAAAAAAAAAPA/AAAAAAAA4D8AAAAAAADgPwAAAAAAAOA/AAAAAAAA4D8AAAAAAADgPwAAAAAAAOA/AAAAAAAA4D8CAAAAjAAAAAAAAAAAAAAAQoX0DP///wgAAAAAAAAAAAAAAAAAAAAAAAAAAAAAAAAAAAAAZAAAAAEAAABAAAAAAAAAAAAAAAAAAAAAAAAAAAAAAAAAAAAAAAAAAAAAAAAAAAAAAAAAAAAAAAAAAAAAAAAAAAAAAAAAAAAAAAAAAAAAAAAAAAAAAAAAAAAAAAAAAAAAFAAAADwAAAABAAAAAwAAAAE9hQAeAAAAAQAAACMAAAAjAAAAIwAAAB4AAAAAAAAAZAAAAGQAAAAAAAAAZAAAAGQAAAAVAAAAYAAAAAAAAAAAAAAADwAAACADAAAAAAAAAAAAAAEAAACgMgAAVgcAAKr4//8BAAAAf39/AAEAAABkAAAAAAAAABQAAABAHwAAAAAAACYAAAAAAAAAwOD//wAAAAAmAAAAZAAAABYAAABMAAAAAAAAAAAAAAAEAAAAAAAAAAEAAABZWVkKAAAAACgAAAAoAAAAZAAAAGQAAAAAAAAAzMzMAAAAAABQAAAAUAAAAGQAAABkAAAAAAAAABcAAAAUAAAAAAAAAAAAAAD/fwAA/38AAAAAAAAJAAAABAAAACgAAAAeAAAAaAAAAAAAAAAAAAAAAAAAAAAAAAAAAAAAECcAABAnAAAAAAAAAAAAAAAAAAAAAAAAAAAAAAAAAAAAAAAAAAAAABQAAAAAAAAAwMD/AAAAAABkAAAAMgAAAAAAAABkAAAAAAAAAH9/fwAKAAAAIgAAABgAAAAAAAAAAAAAAAAAAAAAAAAAAAAAAAAAAAAkAAAAJAAAAAAAAAAHAAAAAAAAAAAAAAAAAAAAAAAAAAAAAAAAAAAAf39/ACUAAABYAAAAAAAAAAAAAAAAAAAAAAAAAAAAAAAAAAAAAAAAAAAAAAAAAAAAAAAAAAAAAAA/AAAAAAAAAKCGAQAAAAAAAAAAAAAAAAAMAAAAAQAAAAAAAAAAAAAAAAAAAB8AAABUAAAAQoX0Bf///wEAAAAAAAAAAAAAAAAAAAAAAAAAAAAAAAAAAAAAAAAAAAE9hQB/f38AWVlZA8zMzADAwP8Af39/AAAAAAAAAAAAAAAAAAAAAAAAAAAAIQAAABgAAAAUAAAAMAQAAFofAAAxBAAAgCQAABAAAAAmAAAACAAAAP//////////"/>
               </a:ext>
             </a:extLst>
           </p:cNvCxnSpPr>
@@ -12037,7 +11689,7 @@
             <a:spLocks noGrp="1" noChangeArrowheads="1"/>
             <a:extLst>
               <a:ext uri="smNativeData">
-                <pr:smNativeData xmlns:pr="smNativeData" xmlns="smNativeData" val="SMDATA_15_EkJ5ZhMAAAAlAAAAZAAAAA0AAAAAkAAAAJAAAACQAAAAkAAAAAAAAAAAAAAAAAAAAAEAAABQAAAAAAAAAAAA4D8AAAAAAADgPwAAAAAAAOA/AAAAAAAA4D8AAAAAAADgPwAAAAAAAOA/AAAAAAAA4D8AAAAAAADgPwAAAAAAAOA/AAAAAAAA4D8CAAAAjAAAAAAAAAAAAAAAQoX0DP///wgAAAAAAAAAAAAAAAAAAAAAAAAAAAAAAAAAAAAAZAAAAAEAAABAAAAAAAAAAAAAAAAAAAAAAAAAAAAAAAAAAAAAAAAAAAAAAAAAAAAAAAAAAAAAAAAAAAAAAAAAAAAAAAAAAAAAAAAAAAAAAAAAAAAAAAAAAAAAAAAAAAAAFAAAADwAAAAAAAAAAAAAAAAAAAkUAAAAAQAAABQAAAAUAAAAFAAAAAEAAAAAAAAAZAAAAGQAAAAAAAAAZAAAAGQAAAAVAAAAYAAAAAAAAAAAAAAADwAAACADAAAAAAAAAAAAAAEAAACgMgAAVgcAAKr4//8BAAAAf39/AAEAAABkAAAAAAAAABQAAABAHwAAAAAAACYAAAAAAAAAwOD//wAAAAAmAAAAZAAAABYAAABMAAAAAAAAAAAAAAAEAAAAAAAAAAEAAABZWVkKAAAAACgAAAAoAAAAZAAAAGQAAAAAAAAAzMzMAAAAAABQAAAAUAAAAGQAAABkAAAAAAAAABcAAAAUAAAAAAAAAAAAAAD/fwAA/38AAAAAAAAJAAAABAAAACOP964eAAAAaAAAAAAAAAAAAAAAAAAAAAAAAAAAAAAAECcAABAnAAAAAAAAAAAAAAAAAAAAAAAAAAAAAAAAAAAAAAAAAAAAABQAAAAAAAAAwMD/AAAAAABkAAAAMgAAAAAAAABkAAAAAAAAAH9/fwAKAAAAIgAAABgAAAAAAAAAAAAAAAAAAAAAAAAAAAAAAAAAAAAkAAAAJAAAAAAAAAAHAAAAAAAAAAAAAAAAAAAAAAAAAAAAAAAAAAAAf39/ACUAAABYAAAAAAAAAAAAAAAAAAAAAAAAAAAAAAAAAAAAAAAAAAAAAAAAAAAAAAAAAAAAAAA/AAAAAAAAAKCGAQAAAAAAAAAAAAAAAAAMAAAAAQAAAAAAAAAAAAAAAAAAAB8AAABUAAAAAAAABQAAAAEAAAAAAAAAAAAAAAAAAAAAAAAAAAAAAAAAAAAAAAAAAAAAAAJ/f38AWVlZA8zMzADAwP8Af39/AAAAAAAAAAAAAAAAAAAAAAAAAAAAIQAAABgAAAAUAAAAFAMAALYCAAB/NwAAvwoAABAAAAAmAAAACAAAADwwAAAAAAAA"/>
+                <pr:smNativeData xmlns:pr="smNativeData" xmlns="smNativeData" val="SMDATA_15_LkR5ZhMAAAAlAAAAZAAAAA0AAAAAkAAAAJAAAACQAAAAkAAAAAAAAAAAAAAAAAAAAAEAAABQAAAAAAAAAAAA4D8AAAAAAADgPwAAAAAAAOA/AAAAAAAA4D8AAAAAAADgPwAAAAAAAOA/AAAAAAAA4D8AAAAAAADgPwAAAAAAAOA/AAAAAAAA4D8CAAAAjAAAAAAAAAAAAAAAQoX0DP///wgAAAAAAAAAAAAAAAAAAAAAAAAAAAAAAAAAAAAAZAAAAAEAAABAAAAAAAAAAAAAAAAAAAAAAAAAAAAAAAAAAAAAAAAAAAAAAAAAAAAAAAAAAAAAAAAAAAAAAAAAAAAAAAAAAAAAAAAAAAAAAAAAAAAAAAAAAAAAAAAAAAAAFAAAADwAAAAAAAAAAAAAAAAAAAkUAAAAAQAAABQAAAAUAAAAFAAAAAEAAAAAAAAAZAAAAGQAAAAAAAAAZAAAAGQAAAAVAAAAYAAAAAAAAAAAAAAADwAAACADAAAAAAAAAAAAAAEAAACgMgAAVgcAAKr4//8BAAAAf39/AAEAAABkAAAAAAAAABQAAABAHwAAAAAAACYAAAAAAAAAwOD//wAAAAAmAAAAZAAAABYAAABMAAAAAAAAAAAAAAAEAAAAAAAAAAEAAABZWVkKAAAAACgAAAAoAAAAZAAAAGQAAAAAAAAAzMzMAAAAAABQAAAAUAAAAGQAAABkAAAAAAAAABcAAAAUAAAAAAAAAAAAAAD/fwAA/38AAAAAAAAJAAAABAAAACOP964eAAAAaAAAAAAAAAAAAAAAAAAAAAAAAAAAAAAAECcAABAnAAAAAAAAAAAAAAAAAAAAAAAAAAAAAAAAAAAAAAAAAAAAABQAAAAAAAAAwMD/AAAAAABkAAAAMgAAAAAAAABkAAAAAAAAAH9/fwAKAAAAIgAAABgAAAAAAAAAAAAAAAAAAAAAAAAAAAAAAAAAAAAkAAAAJAAAAAAAAAAHAAAAAAAAAAAAAAAAAAAAAAAAAAAAAAAAAAAAf39/ACUAAABYAAAAAAAAAAAAAAAAAAAAAAAAAAAAAAAAAAAAAAAAAAAAAAAAAAAAAAAAAAAAAAA/AAAAAAAAAKCGAQAAAAAAAAAAAAAAAAAMAAAAAQAAAAAAAAAAAAAAAAAAAB8AAABUAAAAAAAABQAAAAEAAAAAAAAAAAAAAAAAAAAAAAAAAAAAAAAAAAAAAAAAAAAAAAJ/f38AWVlZA8zMzADAwP8Af39/AAAAAAAAAAAAAAAAAAAAAAAAAAAAIQAAABgAAAAUAAAAFAMAALYCAAB/NwAAvwoAABAAAAAmAAAACAAAADwwAAAAAAAA"/>
               </a:ext>
             </a:extLst>
           </p:cNvSpPr>
@@ -12067,6 +11719,7 @@
               <a:rPr lang="ru-ru" cap="none"/>
               <a:t>Цели проекта</a:t>
             </a:r>
+            <a:endParaRPr lang="ru-ru" cap="none"/>
           </a:p>
         </p:txBody>
       </p:sp>
@@ -12106,11 +11759,6 @@
                           <a:spcPts val="0"/>
                         </a:spcAft>
                         <a:buNone/>
-                        <a:defRPr cap="none">
-                          <a:solidFill>
-                            <a:srgbClr val="000000"/>
-                          </a:solidFill>
-                        </a:defRPr>
                       </a:pPr>
                       <a:r>
                         <a:rPr lang="ru-ru" sz="1700" b="1" cap="none">
@@ -12181,11 +11829,6 @@
                           <a:spcPts val="0"/>
                         </a:spcAft>
                         <a:buNone/>
-                        <a:defRPr cap="none">
-                          <a:solidFill>
-                            <a:srgbClr val="000000"/>
-                          </a:solidFill>
-                        </a:defRPr>
                       </a:pPr>
                       <a:r>
                         <a:rPr sz="1700" cap="none">
@@ -12236,7 +11879,7 @@
                 </a:tc>
                 <a:extLst>
                   <a:ext uri="smNativeData">
-                    <pr:rowheight xmlns="" xmlns:pr="smNativeData" dt="1719222802" type="min" val="381000"/>
+                    <pr:rowheight xmlns="" xmlns:pr="smNativeData" dt="1719223342" type="min" val="381000"/>
                   </a:ext>
                 </a:extLst>
               </a:tr>
@@ -12254,11 +11897,6 @@
                           <a:spcPts val="0"/>
                         </a:spcAft>
                         <a:buNone/>
-                        <a:defRPr cap="none">
-                          <a:solidFill>
-                            <a:srgbClr val="000000"/>
-                          </a:solidFill>
-                        </a:defRPr>
                       </a:pPr>
                       <a:r>
                         <a:rPr lang="ru-ru" sz="1700" b="1" cap="none">
@@ -12334,11 +11972,6 @@
                           <a:spcPts val="0"/>
                         </a:spcAft>
                         <a:buNone/>
-                        <a:defRPr cap="none">
-                          <a:solidFill>
-                            <a:srgbClr val="000000"/>
-                          </a:solidFill>
-                        </a:defRPr>
                       </a:pPr>
                       <a:r>
                         <a:rPr sz="1700" cap="none">
@@ -12394,7 +12027,7 @@
                 </a:tc>
                 <a:extLst>
                   <a:ext uri="smNativeData">
-                    <pr:rowheight xmlns="" xmlns:pr="smNativeData" dt="1719222802" type="min" val="381000"/>
+                    <pr:rowheight xmlns="" xmlns:pr="smNativeData" dt="1719223342" type="min" val="381000"/>
                   </a:ext>
                 </a:extLst>
               </a:tr>
@@ -12412,11 +12045,6 @@
                           <a:spcPts val="0"/>
                         </a:spcAft>
                         <a:buNone/>
-                        <a:defRPr cap="none">
-                          <a:solidFill>
-                            <a:srgbClr val="000000"/>
-                          </a:solidFill>
-                        </a:defRPr>
                       </a:pPr>
                       <a:r>
                         <a:rPr lang="ru-ru" sz="1700" b="1" cap="none">
@@ -12492,11 +12120,6 @@
                           <a:spcPts val="0"/>
                         </a:spcAft>
                         <a:buNone/>
-                        <a:defRPr cap="none">
-                          <a:solidFill>
-                            <a:srgbClr val="000000"/>
-                          </a:solidFill>
-                        </a:defRPr>
                       </a:pPr>
                       <a:r>
                         <a:rPr sz="1700" cap="none">
@@ -12552,7 +12175,7 @@
                 </a:tc>
                 <a:extLst>
                   <a:ext uri="smNativeData">
-                    <pr:rowheight xmlns="" xmlns:pr="smNativeData" dt="1719222802" type="min" val="381000"/>
+                    <pr:rowheight xmlns="" xmlns:pr="smNativeData" dt="1719223342" type="min" val="381000"/>
                   </a:ext>
                 </a:extLst>
               </a:tr>
@@ -12570,11 +12193,6 @@
                           <a:spcPts val="0"/>
                         </a:spcAft>
                         <a:buNone/>
-                        <a:defRPr cap="none">
-                          <a:solidFill>
-                            <a:srgbClr val="000000"/>
-                          </a:solidFill>
-                        </a:defRPr>
                       </a:pPr>
                       <a:r>
                         <a:rPr lang="ru-ru" sz="1700" b="1" cap="none">
@@ -12650,11 +12268,6 @@
                           <a:spcPts val="0"/>
                         </a:spcAft>
                         <a:buNone/>
-                        <a:defRPr cap="none">
-                          <a:solidFill>
-                            <a:srgbClr val="000000"/>
-                          </a:solidFill>
-                        </a:defRPr>
                       </a:pPr>
                       <a:r>
                         <a:rPr sz="1700" cap="none">
@@ -12710,7 +12323,7 @@
                 </a:tc>
                 <a:extLst>
                   <a:ext uri="smNativeData">
-                    <pr:rowheight xmlns="" xmlns:pr="smNativeData" dt="1719222802" type="min" val="381000"/>
+                    <pr:rowheight xmlns="" xmlns:pr="smNativeData" dt="1719223342" type="min" val="381000"/>
                   </a:ext>
                 </a:extLst>
               </a:tr>
@@ -12724,7 +12337,7 @@
           <p:cNvSpPr>
             <a:extLst>
               <a:ext uri="smNativeData">
-                <pr:smNativeData xmlns:pr="smNativeData" xmlns="smNativeData" val="SMDATA_15_EkJ5ZhMAAAAlAAAA9AEAAA0AAAAAOAEAAMYAAAA4AQAAxgAAAAAAAAABAAAAAAAAAAEAAABQAAAAe0ljtI6q2r8AAAAAAAD0PwAAAAAAAOA/AAAAAAAA4D8AAAAAAADgPwAAAAAAAOA/AAAAAAAA4D8AAAAAAADgPwAAAAAAAOA/AAAAAAAA4D8CAAAAjAAAAAEAAAAAAAAA8/PzAP///wgAAAAAAAAAAAAAAAAAAAAAAAAAAAAAAAAAAAAAeAAAAAEAAABAAAAAAAAAAAAAAABaAAAAAAAAAAAAAAAAAAAAAAAAAAAAAAAAAAAAAAAAAAAAAAAAAAAAAAAAAAAAAAAAAAAAAAAAAAAAAAAAAAAAAAAAAAAAAAAAAAAAFAAAADwAAAABAAAAAAAAAAE9hQAPAAAAAQAAACMAAAAjAAAAIwAAAB4AAAAAAAAASwAAAEsAAAAAAAAASwAAAEsAAAAVAAAAYAAAAAAAAAAAAAAADwAAACADAAAAAAAAAAAAAAEAAACgMgAAVgcAAKr4//8BAAAAf39/AAEAAABkAAAAAAAAABQAAABAHwAAAAAAACYAAAAAAAAAwOD//wAAAAAmAAAAZAAAABYAAABMAAAAAAAAAAAAAAAEAAAAAAAAAAEAAABZWVkKAAAAACgAAAAoAAAAZAAAAGQAAAAAAAAAzMzMAAAAAABQAAAAUAAAAGQAAABkAAAAAAAAABcAAAAUAAAAAAAAAAAAAAD/fwAA/38AAAAAAAAJAAAABAAAADpUCpYeAAAAaAAAAAAAAAAAAAAAAAAAAAAAAAAAAAAAECcAABAnAAAAAAAAAAAAAAAAAAAAAAAAAAAAAAAAAAAAAAAAAAAAABQAAAAAAAAAwMD/AAAAAABkAAAAMgAAAAAAAABkAAAAAAAAAH9/fwAKAAAAIgAAABgAAAAAAAAAAAAAAAAAAAAAAAAAAAAAAAAAAAAkAAAAJAAAAAAAAAAHAAAAAAAAAAAAAAAAAAAAAAAAAAAAAAAAAAAAf39/ACUAAABYAAAAAAAAAAAAAAAAAAAAAAAAAAAAAAAAAAAAAAAAAAAAAAAAAAAAAAAAAAAAAAA/AAAAAAAAAKCGAQAAAAAAAAAAAAAAAAAMAAAAAQAAAAAAAAAAAAAAAAAAAB8AAABUAAAA8/PzAP///wEAAAAAAAAAAAAAAAAAAAAAAAAAAAAAAAAAAAAAAAAAAAE9hQB/f38AWVlZA8zMzADAwP8Af39/AAAAAAAAAAAAAAAAAAAAAAAAAAAAIQAAABgAAAAUAAAA2CAAAFMCAADnNQAACwkAABAAAAAmAAAACAAAAP//////////"/>
+                <pr:smNativeData xmlns:pr="smNativeData" xmlns="smNativeData" val="SMDATA_15_LkR5ZhMAAAAlAAAA9AEAAA0AAAAAOAEAAMYAAAA4AQAAxgAAAAAAAAABAAAAAAAAAAEAAABQAAAAe0ljtI6q2r8AAAAAAAD0PwAAAAAAAOA/AAAAAAAA4D8AAAAAAADgPwAAAAAAAOA/AAAAAAAA4D8AAAAAAADgPwAAAAAAAOA/AAAAAAAA4D8CAAAAjAAAAAEAAAAAAAAA8/PzAP///wgAAAAAAAAAAAAAAAAAAAAAAAAAAAAAAAAAAAAAeAAAAAEAAABAAAAAAAAAAAAAAABaAAAAAAAAAAAAAAAAAAAAAAAAAAAAAAAAAAAAAAAAAAAAAAAAAAAAAAAAAAAAAAAAAAAAAAAAAAAAAAAAAAAAAAAAAAAAAAAAAAAAFAAAADwAAAABAAAAAAAAAAE9hQAPAAAAAQAAACMAAAAjAAAAIwAAAB4AAAAAAAAASwAAAEsAAAAAAAAASwAAAEsAAAAVAAAAYAAAAAAAAAAAAAAADwAAACADAAAAAAAAAAAAAAEAAACgMgAAVgcAAKr4//8BAAAAf39/AAEAAABkAAAAAAAAABQAAABAHwAAAAAAACYAAAAAAAAAwOD//wAAAAAmAAAAZAAAABYAAABMAAAAAAAAAAAAAAAEAAAAAAAAAAEAAABZWVkKAAAAACgAAAAoAAAAZAAAAGQAAAAAAAAAzMzMAAAAAABQAAAAUAAAAGQAAABkAAAAAAAAABcAAAAUAAAAAAAAAAAAAAD/fwAA/38AAAAAAAAJAAAABAAAADpUCpYeAAAAaAAAAAAAAAAAAAAAAAAAAAAAAAAAAAAAECcAABAnAAAAAAAAAAAAAAAAAAAAAAAAAAAAAAAAAAAAAAAAAAAAABQAAAAAAAAAwMD/AAAAAABkAAAAMgAAAAAAAABkAAAAAAAAAH9/fwAKAAAAIgAAABgAAAAAAAAAAAAAAAAAAAAAAAAAAAAAAAAAAAAkAAAAJAAAAAAAAAAHAAAAAAAAAAAAAAAAAAAAAAAAAAAAAAAAAAAAf39/ACUAAABYAAAAAAAAAAAAAAAAAAAAAAAAAAAAAAAAAAAAAAAAAAAAAAAAAAAAAAAAAAAAAAA/AAAAAAAAAKCGAQAAAAAAAAAAAAAAAAAMAAAAAQAAAAAAAAAAAAAAAAAAAB8AAABUAAAA8/PzAP///wEAAAAAAAAAAAAAAAAAAAAAAAAAAAAAAAAAAAAAAAAAAAE9hQB/f38AWVlZA8zMzADAwP8Af39/AAAAAAAAAAAAAAAAAAAAAAAAAAAAIQAAABgAAAAUAAAA2CAAAFMCAADnNQAACwkAABAAAAAmAAAACAAAAP//////////"/>
               </a:ext>
             </a:extLst>
           </p:cNvSpPr>
@@ -12828,7 +12441,7 @@
             <a:spLocks noGrp="1" noChangeArrowheads="1"/>
             <a:extLst>
               <a:ext uri="smNativeData">
-                <pr:smNativeData xmlns:pr="smNativeData" xmlns="smNativeData" val="SMDATA_15_EkJ5ZhMAAAAlAAAAZAAAAA0AAAAAkAAAAJAAAACQAAAAkAAAAAAAAAAAAAAAAAAAAAEAAABQAAAAAAAAAAAA4D8AAAAAAADgPwAAAAAAAOA/AAAAAAAA4D8AAAAAAADgPwAAAAAAAOA/AAAAAAAA4D8AAAAAAADgPwAAAAAAAOA/AAAAAAAA4D8CAAAAjAAAAAAAAAAAAAAAQoX0DP///wgAAAAAAAAAAAAAAAAAAAAAAAAAAAAAAAAAAAAAZAAAAAEAAABAAAAAAAAAAAAAAAAAAAAAAAAAAAAAAAAAAAAAAAAAAAAAAAAAAAAAAAAAAAAAAAAAAAAAAAAAAAAAAAAAAAAAAAAAAAAAAAAAAAAAAAAAAAAAAAAAAAAAFAAAADwAAAAAAAAAAAAAAAAAAAkUAAAAAQAAABQAAAAUAAAAFAAAAAEAAAAAAAAAZAAAAGQAAAAAAAAAZAAAAGQAAAAVAAAAYAAAAAAAAAAAAAAADwAAACADAAAAAAAAAAAAAAEAAACgMgAAVgcAAKr4//8BAAAAf39/AAEAAABkAAAAAAAAABQAAABAHwAAAAAAACYAAAAAAAAAwOD//wAAAAAmAAAAZAAAABYAAABMAAAAAAAAAAAAAAAEAAAAAAAAAAEAAABZWVkKAAAAACgAAAAoAAAAZAAAAGQAAAAAAAAAzMzMAAAAAABQAAAAUAAAAGQAAABkAAAAAAAAABcAAAAUAAAAAAAAAAAAAAD/fwAA/38AAAAAAAAJAAAABAAAAGl3mg4eAAAAaAAAAAAAAAAAAAAAAAAAAAAAAAAAAAAAECcAABAnAAAAAAAAAAAAAAAAAAAAAAAAAAAAAAAAAAAAAAAAAAAAABQAAAAAAAAAwMD/AAAAAABkAAAAMgAAAAAAAABkAAAAAAAAAH9/fwAKAAAAIgAAABgAAAAAAAAAAAAAAAAAAAAAAAAAAAAAAAAAAAAkAAAAJAAAAAAAAAAHAAAAAAAAAAAAAAAAAAAAAAAAAAAAAAAAAAAAf39/ACUAAABYAAAAAAAAAAAAAAAAAAAAAAAAAAAAAAAAAAAAAAAAAAAAAAAAAAAAAAAAAAAAAAA/AAAAAAAAAKCGAQAAAAAAAAAAAAAAAAAMAAAAAQAAAAAAAAAAAAAAAAAAAB8AAABUAAAAAAAABQAAAAEAAAAAAAAAAAAAAAAAAAAAAAAAAAAAAAAAAAAAAAAAAAAAAAJ/f38AWVlZA8zMzADAwP8Af39/AAAAAAAAAAAAAAAAAAAAAAAAAAAAIQAAABgAAAAUAAAAFAMAALYCAAB/NwAAvwoAABAAAAAmAAAACAAAADwwAAAAAAAA"/>
+                <pr:smNativeData xmlns:pr="smNativeData" xmlns="smNativeData" val="SMDATA_15_LkR5ZhMAAAAlAAAAZAAAAA0AAAAAkAAAAJAAAACQAAAAkAAAAAAAAAAAAAAAAAAAAAEAAABQAAAAAAAAAAAA4D8AAAAAAADgPwAAAAAAAOA/AAAAAAAA4D8AAAAAAADgPwAAAAAAAOA/AAAAAAAA4D8AAAAAAADgPwAAAAAAAOA/AAAAAAAA4D8CAAAAjAAAAAAAAAAAAAAAQoX0DP///wgAAAAAAAAAAAAAAAAAAAAAAAAAAAAAAAAAAAAAZAAAAAEAAABAAAAAAAAAAAAAAAAAAAAAAAAAAAAAAAAAAAAAAAAAAAAAAAAAAAAAAAAAAAAAAAAAAAAAAAAAAAAAAAAAAAAAAAAAAAAAAAAAAAAAAAAAAAAAAAAAAAAAFAAAADwAAAAAAAAAAAAAAAAAAAkUAAAAAQAAABQAAAAUAAAAFAAAAAEAAAAAAAAAZAAAAGQAAAAAAAAAZAAAAGQAAAAVAAAAYAAAAAAAAAAAAAAADwAAACADAAAAAAAAAAAAAAEAAACgMgAAVgcAAKr4//8BAAAAf39/AAEAAABkAAAAAAAAABQAAABAHwAAAAAAACYAAAAAAAAAwOD//wAAAAAmAAAAZAAAABYAAABMAAAAAAAAAAAAAAAEAAAAAAAAAAEAAABZWVkKAAAAACgAAAAoAAAAZAAAAGQAAAAAAAAAzMzMAAAAAABQAAAAUAAAAGQAAABkAAAAAAAAABcAAAAUAAAAAAAAAAAAAAD/fwAA/38AAAAAAAAJAAAABAAAAGl3mg4eAAAAaAAAAAAAAAAAAAAAAAAAAAAAAAAAAAAAECcAABAnAAAAAAAAAAAAAAAAAAAAAAAAAAAAAAAAAAAAAAAAAAAAABQAAAAAAAAAwMD/AAAAAABkAAAAMgAAAAAAAABkAAAAAAAAAH9/fwAKAAAAIgAAABgAAAAAAAAAAAAAAAAAAAAAAAAAAAAAAAAAAAAkAAAAJAAAAAAAAAAHAAAAAAAAAAAAAAAAAAAAAAAAAAAAAAAAAAAAf39/ACUAAABYAAAAAAAAAAAAAAAAAAAAAAAAAAAAAAAAAAAAAAAAAAAAAAAAAAAAAAAAAAAAAAA/AAAAAAAAAKCGAQAAAAAAAAAAAAAAAAAMAAAAAQAAAAAAAAAAAAAAAAAAAB8AAABUAAAAAAAABQAAAAEAAAAAAAAAAAAAAAAAAAAAAAAAAAAAAAAAAAAAAAAAAAAAAAJ/f38AWVlZA8zMzADAwP8Af39/AAAAAAAAAAAAAAAAAAAAAAAAAAAAIQAAABgAAAAUAAAAFAMAALYCAAB/NwAAvwoAABAAAAAmAAAACAAAADwwAAAAAAAA"/>
               </a:ext>
             </a:extLst>
           </p:cNvSpPr>
@@ -12858,6 +12471,7 @@
               <a:rPr lang="ru-ru" cap="none"/>
               <a:t>Что планировалось</a:t>
             </a:r>
+            <a:endParaRPr lang="ru-ru" cap="none"/>
           </a:p>
         </p:txBody>
       </p:sp>
@@ -12897,11 +12511,6 @@
                           <a:spcPts val="0"/>
                         </a:spcAft>
                         <a:buNone/>
-                        <a:defRPr cap="none">
-                          <a:solidFill>
-                            <a:srgbClr val="000000"/>
-                          </a:solidFill>
-                        </a:defRPr>
                       </a:pPr>
                       <a:r>
                         <a:rPr lang="ru-ru" sz="1700" b="1" cap="none">
@@ -12972,11 +12581,6 @@
                           <a:spcPts val="0"/>
                         </a:spcAft>
                         <a:buNone/>
-                        <a:defRPr cap="none">
-                          <a:solidFill>
-                            <a:srgbClr val="000000"/>
-                          </a:solidFill>
-                        </a:defRPr>
                       </a:pPr>
                       <a:r>
                         <a:rPr sz="1700" cap="none">
@@ -13027,7 +12631,7 @@
                 </a:tc>
                 <a:extLst>
                   <a:ext uri="smNativeData">
-                    <pr:rowheight xmlns="" xmlns:pr="smNativeData" dt="1719222802" type="min" val="381000"/>
+                    <pr:rowheight xmlns="" xmlns:pr="smNativeData" dt="1719223342" type="min" val="381000"/>
                   </a:ext>
                 </a:extLst>
               </a:tr>
@@ -13045,11 +12649,6 @@
                           <a:spcPts val="0"/>
                         </a:spcAft>
                         <a:buNone/>
-                        <a:defRPr cap="none">
-                          <a:solidFill>
-                            <a:srgbClr val="000000"/>
-                          </a:solidFill>
-                        </a:defRPr>
                       </a:pPr>
                       <a:r>
                         <a:rPr lang="ru-ru" sz="1700" b="1" cap="none">
@@ -13125,11 +12724,6 @@
                           <a:spcPts val="0"/>
                         </a:spcAft>
                         <a:buNone/>
-                        <a:defRPr cap="none">
-                          <a:solidFill>
-                            <a:srgbClr val="000000"/>
-                          </a:solidFill>
-                        </a:defRPr>
                       </a:pPr>
                       <a:r>
                         <a:rPr sz="1700" cap="none">
@@ -13185,7 +12779,7 @@
                 </a:tc>
                 <a:extLst>
                   <a:ext uri="smNativeData">
-                    <pr:rowheight xmlns="" xmlns:pr="smNativeData" dt="1719222802" type="min" val="381000"/>
+                    <pr:rowheight xmlns="" xmlns:pr="smNativeData" dt="1719223342" type="min" val="381000"/>
                   </a:ext>
                 </a:extLst>
               </a:tr>
@@ -13203,11 +12797,6 @@
                           <a:spcPts val="0"/>
                         </a:spcAft>
                         <a:buNone/>
-                        <a:defRPr cap="none">
-                          <a:solidFill>
-                            <a:srgbClr val="000000"/>
-                          </a:solidFill>
-                        </a:defRPr>
                       </a:pPr>
                       <a:r>
                         <a:rPr lang="ru-ru" sz="1700" b="1" cap="none">
@@ -13283,11 +12872,6 @@
                           <a:spcPts val="0"/>
                         </a:spcAft>
                         <a:buNone/>
-                        <a:defRPr cap="none">
-                          <a:solidFill>
-                            <a:srgbClr val="000000"/>
-                          </a:solidFill>
-                        </a:defRPr>
                       </a:pPr>
                       <a:r>
                         <a:rPr sz="1700" cap="none">
@@ -13343,7 +12927,7 @@
                 </a:tc>
                 <a:extLst>
                   <a:ext uri="smNativeData">
-                    <pr:rowheight xmlns="" xmlns:pr="smNativeData" dt="1719222802" type="min" val="381000"/>
+                    <pr:rowheight xmlns="" xmlns:pr="smNativeData" dt="1719223342" type="min" val="381000"/>
                   </a:ext>
                 </a:extLst>
               </a:tr>
@@ -13361,11 +12945,6 @@
                           <a:spcPts val="0"/>
                         </a:spcAft>
                         <a:buNone/>
-                        <a:defRPr cap="none">
-                          <a:solidFill>
-                            <a:srgbClr val="000000"/>
-                          </a:solidFill>
-                        </a:defRPr>
                       </a:pPr>
                       <a:r>
                         <a:rPr lang="ru-ru" sz="1700" b="1" cap="none">
@@ -13441,11 +13020,6 @@
                           <a:spcPts val="0"/>
                         </a:spcAft>
                         <a:buNone/>
-                        <a:defRPr cap="none">
-                          <a:solidFill>
-                            <a:srgbClr val="000000"/>
-                          </a:solidFill>
-                        </a:defRPr>
                       </a:pPr>
                       <a:endParaRPr sz="1700" cap="none">
                         <a:latin typeface="Roboto" pitchFamily="0" charset="0"/>
@@ -13493,7 +13067,7 @@
                 </a:tc>
                 <a:extLst>
                   <a:ext uri="smNativeData">
-                    <pr:rowheight xmlns="" xmlns:pr="smNativeData" dt="1719222802" type="min" val="381000"/>
+                    <pr:rowheight xmlns="" xmlns:pr="smNativeData" dt="1719223342" type="min" val="381000"/>
                   </a:ext>
                 </a:extLst>
               </a:tr>
@@ -13507,7 +13081,7 @@
           <p:cNvSpPr>
             <a:extLst>
               <a:ext uri="smNativeData">
-                <pr:smNativeData xmlns:pr="smNativeData" xmlns="smNativeData" val="SMDATA_15_EkJ5ZhMAAAAlAAAA9AEAAA0AAAAAOAEAAMYAAAA4AQAAxgAAAAAAAAABAAAAAAAAAAEAAABQAAAAe0ljtI6q2r8AAAAAAAD0PwAAAAAAAOA/AAAAAAAA4D8AAAAAAADgPwAAAAAAAOA/AAAAAAAA4D8AAAAAAADgPwAAAAAAAOA/AAAAAAAA4D8CAAAAjAAAAAEAAAAAAAAA8/PzAP///wgAAAAAAAAAAAAAAAAAAAAAAAAAAAAAAAAAAAAAeAAAAAEAAABAAAAAAAAAAAAAAABaAAAAAAAAAAAAAAAAAAAAAAAAAAAAAAAAAAAAAAAAAAAAAAAAAAAAAAAAAAAAAAAAAAAAAAAAAAAAAAAAAAAAAAAAAAAAAAAAAAAAFAAAADwAAAABAAAAAAAAAAE9hQAPAAAAAQAAACMAAAAjAAAAIwAAAB4AAAAAAAAASwAAAEsAAAAAAAAASwAAAEsAAAAVAAAAYAAAAAAAAAAAAAAADwAAACADAAAAAAAAAAAAAAEAAACgMgAAVgcAAKr4//8BAAAAf39/AAEAAABkAAAAAAAAABQAAABAHwAAAAAAACYAAAAAAAAAwOD//wAAAAAmAAAAZAAAABYAAABMAAAAAAAAAAAAAAAEAAAAAAAAAAEAAABZWVkKAAAAACgAAAAoAAAAZAAAAGQAAAAAAAAAzMzMAAAAAABQAAAAUAAAAGQAAABkAAAAAAAAABcAAAAUAAAAAAAAAAAAAAD/fwAA/38AAAAAAAAJAAAABAAAACgVFOgeAAAAaAAAAAAAAAAAAAAAAAAAAAAAAAAAAAAAECcAABAnAAAAAAAAAAAAAAAAAAAAAAAAAAAAAAAAAAAAAAAAAAAAABQAAAAAAAAAwMD/AAAAAABkAAAAMgAAAAAAAABkAAAAAAAAAH9/fwAKAAAAIgAAABgAAAAAAAAAAAAAAAAAAAAAAAAAAAAAAAAAAAAkAAAAJAAAAAAAAAAHAAAAAAAAAAAAAAAAAAAAAAAAAAAAAAAAAAAAf39/ACUAAABYAAAAAAAAAAAAAAAAAAAAAAAAAAAAAAAAAAAAAAAAAAAAAAAAAAAAAAAAAAAAAAA/AAAAAAAAAKCGAQAAAAAAAAAAAAAAAAAMAAAAAQAAAAAAAAAAAAAAAAAAAB8AAABUAAAA8/PzAP///wEAAAAAAAAAAAAAAAAAAAAAAAAAAAAAAAAAAAAAAAAAAAE9hQB/f38AWVlZA8zMzADAwP8Af39/AAAAAAAAAAAAAAAAAAAAAAAAAAAAIQAAABgAAAAUAAAA2CAAAFMCAADnNQAACwkAABAAAAAmAAAACAAAAP//////////"/>
+                <pr:smNativeData xmlns:pr="smNativeData" xmlns="smNativeData" val="SMDATA_15_LkR5ZhMAAAAlAAAA9AEAAA0AAAAAOAEAAMYAAAA4AQAAxgAAAAAAAAABAAAAAAAAAAEAAABQAAAAe0ljtI6q2r8AAAAAAAD0PwAAAAAAAOA/AAAAAAAA4D8AAAAAAADgPwAAAAAAAOA/AAAAAAAA4D8AAAAAAADgPwAAAAAAAOA/AAAAAAAA4D8CAAAAjAAAAAEAAAAAAAAA8/PzAP///wgAAAAAAAAAAAAAAAAAAAAAAAAAAAAAAAAAAAAAeAAAAAEAAABAAAAAAAAAAAAAAABaAAAAAAAAAAAAAAAAAAAAAAAAAAAAAAAAAAAAAAAAAAAAAAAAAAAAAAAAAAAAAAAAAAAAAAAAAAAAAAAAAAAAAAAAAAAAAAAAAAAAFAAAADwAAAABAAAAAAAAAAE9hQAPAAAAAQAAACMAAAAjAAAAIwAAAB4AAAAAAAAASwAAAEsAAAAAAAAASwAAAEsAAAAVAAAAYAAAAAAAAAAAAAAADwAAACADAAAAAAAAAAAAAAEAAACgMgAAVgcAAKr4//8BAAAAf39/AAEAAABkAAAAAAAAABQAAABAHwAAAAAAACYAAAAAAAAAwOD//wAAAAAmAAAAZAAAABYAAABMAAAAAAAAAAAAAAAEAAAAAAAAAAEAAABZWVkKAAAAACgAAAAoAAAAZAAAAGQAAAAAAAAAzMzMAAAAAABQAAAAUAAAAGQAAABkAAAAAAAAABcAAAAUAAAAAAAAAAAAAAD/fwAA/38AAAAAAAAJAAAABAAAACgVFOgeAAAAaAAAAAAAAAAAAAAAAAAAAAAAAAAAAAAAECcAABAnAAAAAAAAAAAAAAAAAAAAAAAAAAAAAAAAAAAAAAAAAAAAABQAAAAAAAAAwMD/AAAAAABkAAAAMgAAAAAAAABkAAAAAAAAAH9/fwAKAAAAIgAAABgAAAAAAAAAAAAAAAAAAAAAAAAAAAAAAAAAAAAkAAAAJAAAAAAAAAAHAAAAAAAAAAAAAAAAAAAAAAAAAAAAAAAAAAAAf39/ACUAAABYAAAAAAAAAAAAAAAAAAAAAAAAAAAAAAAAAAAAAAAAAAAAAAAAAAAAAAAAAAAAAAA/AAAAAAAAAKCGAQAAAAAAAAAAAAAAAAAMAAAAAQAAAAAAAAAAAAAAAAAAAB8AAABUAAAA8/PzAP///wEAAAAAAAAAAAAAAAAAAAAAAAAAAAAAAAAAAAAAAAAAAAE9hQB/f38AWVlZA8zMzADAwP8Af39/AAAAAAAAAAAAAAAAAAAAAAAAAAAAIQAAABgAAAAUAAAA2CAAAFMCAADnNQAACwkAABAAAAAmAAAACAAAAP//////////"/>
               </a:ext>
             </a:extLst>
           </p:cNvSpPr>
@@ -13611,7 +13185,7 @@
             <a:spLocks noGrp="1" noChangeArrowheads="1"/>
             <a:extLst>
               <a:ext uri="smNativeData">
-                <pr:smNativeData xmlns:pr="smNativeData" xmlns="smNativeData" val="SMDATA_15_EkJ5ZhMAAAAlAAAAZAAAAA0AAAAAkAAAAJAAAACQAAAAkAAAAAAAAAAAAAAAAAAAAAEAAABQAAAAAAAAAAAA4D8AAAAAAADgPwAAAAAAAOA/AAAAAAAA4D8AAAAAAADgPwAAAAAAAOA/AAAAAAAA4D8AAAAAAADgPwAAAAAAAOA/AAAAAAAA4D8CAAAAjAAAAAAAAAAAAAAAQoX0DP///wgAAAAAAAAAAAAAAAAAAAAAAAAAAAAAAAAAAAAAZAAAAAEAAABAAAAAAAAAAAAAAAAAAAAAAAAAAAAAAAAAAAAAAAAAAAAAAAAAAAAAAAAAAAAAAAAAAAAAAAAAAAAAAAAAAAAAAAAAAAAAAAAAAAAAAAAAAAAAAAAAAAAAFAAAADwAAAAAAAAAAAAAAAAAAAkUAAAAAQAAABQAAAAUAAAAFAAAAAEAAAAAAAAAZAAAAGQAAAAAAAAAZAAAAGQAAAAVAAAAYAAAAAAAAAAAAAAADwAAACADAAAAAAAAAAAAAAEAAACgMgAAVgcAAKr4//8BAAAAf39/AAEAAABkAAAAAAAAABQAAABAHwAAAAAAACYAAAAAAAAAwOD//wAAAAAmAAAAZAAAABYAAABMAAAAAAAAAAAAAAAEAAAAAAAAAAEAAABZWVkKAAAAACgAAAAoAAAAZAAAAGQAAAAAAAAAzMzMAAAAAABQAAAAUAAAAGQAAABkAAAAAAAAABcAAAAUAAAAAAAAAAAAAAD/fwAA/38AAAAAAAAJAAAABAAAAMeGczoeAAAAaAAAAAAAAAAAAAAAAAAAAAAAAAAAAAAAECcAABAnAAAAAAAAAAAAAAAAAAAAAAAAAAAAAAAAAAAAAAAAAAAAABQAAAAAAAAAwMD/AAAAAABkAAAAMgAAAAAAAABkAAAAAAAAAH9/fwAKAAAAIgAAABgAAAAAAAAAAAAAAAAAAAAAAAAAAAAAAAAAAAAkAAAAJAAAAAAAAAAHAAAAAAAAAAAAAAAAAAAAAAAAAAAAAAAAAAAAf39/ACUAAABYAAAAAAAAAAAAAAAAAAAAAAAAAAAAAAAAAAAAAAAAAAAAAAAAAAAAAAAAAAAAAAA/AAAAAAAAAKCGAQAAAAAAAAAAAAAAAAAMAAAAAQAAAAAAAAAAAAAAAAAAAB8AAABUAAAAAAAABQAAAAEAAAAAAAAAAAAAAAAAAAAAAAAAAAAAAAAAAAAAAAAAAAAAAAJ/f38AWVlZA8zMzADAwP8Af39/AAAAAAAAAAAAAAAAAAAAAAAAAAAAIQAAABgAAAAUAAAAFAMAALYCAAB/NwAAvwoAABAAAAAmAAAACAAAADwwAAAAAAAA"/>
+                <pr:smNativeData xmlns:pr="smNativeData" xmlns="smNativeData" val="SMDATA_15_LkR5ZhMAAAAlAAAAZAAAAA0AAAAAkAAAAJAAAACQAAAAkAAAAAAAAAAAAAAAAAAAAAEAAABQAAAAAAAAAAAA4D8AAAAAAADgPwAAAAAAAOA/AAAAAAAA4D8AAAAAAADgPwAAAAAAAOA/AAAAAAAA4D8AAAAAAADgPwAAAAAAAOA/AAAAAAAA4D8CAAAAjAAAAAAAAAAAAAAAQoX0DP///wgAAAAAAAAAAAAAAAAAAAAAAAAAAAAAAAAAAAAAZAAAAAEAAABAAAAAAAAAAAAAAAAAAAAAAAAAAAAAAAAAAAAAAAAAAAAAAAAAAAAAAAAAAAAAAAAAAAAAAAAAAAAAAAAAAAAAAAAAAAAAAAAAAAAAAAAAAAAAAAAAAAAAFAAAADwAAAAAAAAAAAAAAAAAAAkUAAAAAQAAABQAAAAUAAAAFAAAAAEAAAAAAAAAZAAAAGQAAAAAAAAAZAAAAGQAAAAVAAAAYAAAAAAAAAAAAAAADwAAACADAAAAAAAAAAAAAAEAAACgMgAAVgcAAKr4//8BAAAAf39/AAEAAABkAAAAAAAAABQAAABAHwAAAAAAACYAAAAAAAAAwOD//wAAAAAmAAAAZAAAABYAAABMAAAAAAAAAAAAAAAEAAAAAAAAAAEAAABZWVkKAAAAACgAAAAoAAAAZAAAAGQAAAAAAAAAzMzMAAAAAABQAAAAUAAAAGQAAABkAAAAAAAAABcAAAAUAAAAAAAAAAAAAAD/fwAA/38AAAAAAAAJAAAABAAAAMeGczoeAAAAaAAAAAAAAAAAAAAAAAAAAAAAAAAAAAAAECcAABAnAAAAAAAAAAAAAAAAAAAAAAAAAAAAAAAAAAAAAAAAAAAAABQAAAAAAAAAwMD/AAAAAABkAAAAMgAAAAAAAABkAAAAAAAAAH9/fwAKAAAAIgAAABgAAAAAAAAAAAAAAAAAAAAAAAAAAAAAAAAAAAAkAAAAJAAAAAAAAAAHAAAAAAAAAAAAAAAAAAAAAAAAAAAAAAAAAAAAf39/ACUAAABYAAAAAAAAAAAAAAAAAAAAAAAAAAAAAAAAAAAAAAAAAAAAAAAAAAAAAAAAAAAAAAA/AAAAAAAAAKCGAQAAAAAAAAAAAAAAAAAMAAAAAQAAAAAAAAAAAAAAAAAAAB8AAABUAAAAAAAABQAAAAEAAAAAAAAAAAAAAAAAAAAAAAAAAAAAAAAAAAAAAAAAAAAAAAJ/f38AWVlZA8zMzADAwP8Af39/AAAAAAAAAAAAAAAAAAAAAAAAAAAAIQAAABgAAAAUAAAAFAMAALYCAAB/NwAAvwoAABAAAAAmAAAACAAAADwwAAAAAAAA"/>
               </a:ext>
             </a:extLst>
           </p:cNvSpPr>
@@ -13641,6 +13215,7 @@
               <a:rPr lang="ru-ru" cap="none"/>
               <a:t>Используемые технологии</a:t>
             </a:r>
+            <a:endParaRPr lang="ru-ru" cap="none"/>
           </a:p>
         </p:txBody>
       </p:sp>
@@ -13680,11 +13255,6 @@
                           <a:spcPts val="0"/>
                         </a:spcAft>
                         <a:buNone/>
-                        <a:defRPr cap="none">
-                          <a:solidFill>
-                            <a:srgbClr val="000000"/>
-                          </a:solidFill>
-                        </a:defRPr>
                       </a:pPr>
                       <a:r>
                         <a:rPr lang="ru-ru" sz="1700" b="1" cap="none">
@@ -13755,11 +13325,6 @@
                           <a:spcPts val="0"/>
                         </a:spcAft>
                         <a:buNone/>
-                        <a:defRPr cap="none">
-                          <a:solidFill>
-                            <a:srgbClr val="000000"/>
-                          </a:solidFill>
-                        </a:defRPr>
                       </a:pPr>
                       <a:r>
                         <a:rPr sz="1700" cap="none">
@@ -13810,7 +13375,7 @@
                 </a:tc>
                 <a:extLst>
                   <a:ext uri="smNativeData">
-                    <pr:rowheight xmlns="" xmlns:pr="smNativeData" dt="1719222802" type="min" val="381000"/>
+                    <pr:rowheight xmlns="" xmlns:pr="smNativeData" dt="1719223342" type="min" val="381000"/>
                   </a:ext>
                 </a:extLst>
               </a:tr>
@@ -13828,11 +13393,6 @@
                           <a:spcPts val="0"/>
                         </a:spcAft>
                         <a:buNone/>
-                        <a:defRPr cap="none">
-                          <a:solidFill>
-                            <a:srgbClr val="000000"/>
-                          </a:solidFill>
-                        </a:defRPr>
                       </a:pPr>
                       <a:r>
                         <a:rPr lang="ru-ru" sz="1700" b="1" cap="none">
@@ -13908,11 +13468,6 @@
                           <a:spcPts val="0"/>
                         </a:spcAft>
                         <a:buNone/>
-                        <a:defRPr cap="none">
-                          <a:solidFill>
-                            <a:srgbClr val="000000"/>
-                          </a:solidFill>
-                        </a:defRPr>
                       </a:pPr>
                       <a:r>
                         <a:rPr sz="1700" cap="none">
@@ -13968,7 +13523,7 @@
                 </a:tc>
                 <a:extLst>
                   <a:ext uri="smNativeData">
-                    <pr:rowheight xmlns="" xmlns:pr="smNativeData" dt="1719222802" type="min" val="381000"/>
+                    <pr:rowheight xmlns="" xmlns:pr="smNativeData" dt="1719223342" type="min" val="381000"/>
                   </a:ext>
                 </a:extLst>
               </a:tr>
@@ -13986,11 +13541,6 @@
                           <a:spcPts val="0"/>
                         </a:spcAft>
                         <a:buNone/>
-                        <a:defRPr cap="none">
-                          <a:solidFill>
-                            <a:srgbClr val="000000"/>
-                          </a:solidFill>
-                        </a:defRPr>
                       </a:pPr>
                       <a:r>
                         <a:rPr lang="ru-ru" sz="1700" b="1" cap="none">
@@ -14066,11 +13616,6 @@
                           <a:spcPts val="0"/>
                         </a:spcAft>
                         <a:buNone/>
-                        <a:defRPr cap="none">
-                          <a:solidFill>
-                            <a:srgbClr val="000000"/>
-                          </a:solidFill>
-                        </a:defRPr>
                       </a:pPr>
                       <a:endParaRPr sz="1700" cap="none">
                         <a:latin typeface="Roboto" pitchFamily="0" charset="0"/>
@@ -14118,7 +13663,7 @@
                 </a:tc>
                 <a:extLst>
                   <a:ext uri="smNativeData">
-                    <pr:rowheight xmlns="" xmlns:pr="smNativeData" dt="1719222802" type="min" val="381000"/>
+                    <pr:rowheight xmlns="" xmlns:pr="smNativeData" dt="1719223342" type="min" val="381000"/>
                   </a:ext>
                 </a:extLst>
               </a:tr>
@@ -14132,7 +13677,7 @@
           <p:cNvSpPr>
             <a:extLst>
               <a:ext uri="smNativeData">
-                <pr:smNativeData xmlns:pr="smNativeData" xmlns="smNativeData" val="SMDATA_15_EkJ5ZhMAAAAlAAAA9AEAAA0AAAAAOAEAAMYAAAA4AQAAxgAAAAAAAAABAAAAAAAAAAEAAABQAAAAR+aRPxh47L8Gu2Hbosz8vwAAAAAAAOA/AAAAAAAA4D8AAAAAAADgPwAAAAAAAOA/AAAAAAAA4D8AAAAAAADgPwAAAAAAAOA/AAAAAAAA4D8CAAAAjAAAAAEAAAAAAAAA8/PzAP///wgAAAAAAAAAAAAAAAAAAAAAAAAAAAAAAAAAAAAAeAAAAAEAAABAAAAAAAAAAAAAAABaAAAAAAAAAAAAAAAAAAAAAAAAAAAAAAAAAAAAAAAAAAAAAAAAAAAAAAAAAAAAAAAAAAAAAAAAAAAAAAAAAAAAAAAAAAAAAAAAAAAAFAAAADwAAAABAAAAAAAAAAE9hQAPAAAAAQAAACMAAAAjAAAAIwAAAB4AAAAAAAAASwAAAEsAAAAAAAAASwAAAEsAAAAVAAAAYAAAAAAAAAAAAAAADwAAACADAAAAAAAAAAAAAAEAAACgMgAAVgcAAKr4//8BAAAAf39/AAEAAABkAAAAAAAAABQAAABAHwAAAAAAACYAAAAAAAAAwOD//wAAAAAmAAAAZAAAABYAAABMAAAAAAAAAAAAAAAEAAAAAAAAAAEAAABZWVkKAAAAACgAAAAoAAAAZAAAAGQAAAAAAAAAzMzMAAAAAABQAAAAUAAAAGQAAABkAAAAAAAAABcAAAAUAAAAAAAAAAAAAAD/fwAA/38AAAAAAAAJAAAABAAAAAECAwAeAAAAaAAAAAAAAAAAAAAAAAAAAAAAAAAAAAAAECcAABAnAAAAAAAAAAAAAAAAAAAAAAAAAAAAAAAAAAAAAAAAAAAAABQAAAAAAAAAwMD/AAAAAABkAAAAMgAAAAAAAABkAAAAAAAAAH9/fwAKAAAAIgAAABgAAAAAAAAAAAAAAAAAAAAAAAAAAAAAAAAAAAAkAAAAJAAAAAAAAAAHAAAAAAAAAAAAAAAAAAAAAAAAAAAAAAAAAAAAf39/ACUAAABYAAAAAAAAAAAAAAAAAAAAAAAAAAAAAAAAAAAAAAAAAAAAAAAAAAAAAAAAAAAAAAA/AAAAAAAAAKCGAQAAAAAAAAAAAAAAAAAMAAAAAQAAAAAAAAAAAAAAAAAAAB8AAABUAAAA8/PzAP///wEAAAAAAAAAAAAAAAAAAAAAAAAAAAAAAAAAAAAAAAAAAAE9hQB/f38AWVlZA8zMzADAwP8Af39/AAAAAAAAAAAAAAAAAAAAAAAAAAAAIQAAABgAAAAUAAAAVR0AALMbAABkMgAAaiIAABAAAAAmAAAACAAAAP//////////"/>
+                <pr:smNativeData xmlns:pr="smNativeData" xmlns="smNativeData" val="SMDATA_15_LkR5ZhMAAAAlAAAA9AEAAA0AAAAAOAEAAMYAAAA4AQAAxgAAAAAAAAABAAAAAAAAAAEAAABQAAAAR+aRPxh47L8Gu2Hbosz8vwAAAAAAAOA/AAAAAAAA4D8AAAAAAADgPwAAAAAAAOA/AAAAAAAA4D8AAAAAAADgPwAAAAAAAOA/AAAAAAAA4D8CAAAAjAAAAAEAAAAAAAAA8/PzAP///wgAAAAAAAAAAAAAAAAAAAAAAAAAAAAAAAAAAAAAeAAAAAEAAABAAAAAAAAAAAAAAABaAAAAAAAAAAAAAAAAAAAAAAAAAAAAAAAAAAAAAAAAAAAAAAAAAAAAAAAAAAAAAAAAAAAAAAAAAAAAAAAAAAAAAAAAAAAAAAAAAAAAFAAAADwAAAABAAAAAAAAAAE9hQAPAAAAAQAAACMAAAAjAAAAIwAAAB4AAAAAAAAASwAAAEsAAAAAAAAASwAAAEsAAAAVAAAAYAAAAAAAAAAAAAAADwAAACADAAAAAAAAAAAAAAEAAACgMgAAVgcAAKr4//8BAAAAf39/AAEAAABkAAAAAAAAABQAAABAHwAAAAAAACYAAAAAAAAAwOD//wAAAAAmAAAAZAAAABYAAABMAAAAAAAAAAAAAAAEAAAAAAAAAAEAAABZWVkKAAAAACgAAAAoAAAAZAAAAGQAAAAAAAAAzMzMAAAAAABQAAAAUAAAAGQAAABkAAAAAAAAABcAAAAUAAAAAAAAAAAAAAD/fwAA/38AAAAAAAAJAAAABAAAAAECAwAeAAAAaAAAAAAAAAAAAAAAAAAAAAAAAAAAAAAAECcAABAnAAAAAAAAAAAAAAAAAAAAAAAAAAAAAAAAAAAAAAAAAAAAABQAAAAAAAAAwMD/AAAAAABkAAAAMgAAAAAAAABkAAAAAAAAAH9/fwAKAAAAIgAAABgAAAAAAAAAAAAAAAAAAAAAAAAAAAAAAAAAAAAkAAAAJAAAAAAAAAAHAAAAAAAAAAAAAAAAAAAAAAAAAAAAAAAAAAAAf39/ACUAAABYAAAAAAAAAAAAAAAAAAAAAAAAAAAAAAAAAAAAAAAAAAAAAAAAAAAAAAAAAAAAAAA/AAAAAAAAAKCGAQAAAAAAAAAAAAAAAAAMAAAAAQAAAAAAAAAAAAAAAAAAAB8AAABUAAAA8/PzAP///wEAAAAAAAAAAAAAAAAAAAAAAAAAAAAAAAAAAAAAAAAAAAE9hQB/f38AWVlZA8zMzADAwP8Af39/AAAAAAAAAAAAAAAAAAAAAAAAAAAAIQAAABgAAAAUAAAAVR0AALMbAABkMgAAaiIAABAAAAAmAAAACAAAAP//////////"/>
               </a:ext>
             </a:extLst>
           </p:cNvSpPr>
@@ -14236,7 +13781,7 @@
             <a:spLocks noGrp="1" noChangeArrowheads="1"/>
             <a:extLst>
               <a:ext uri="smNativeData">
-                <pr:smNativeData xmlns:pr="smNativeData" xmlns="smNativeData" val="SMDATA_15_EkJ5ZhMAAAAlAAAAZAAAAA0AAAAAkAAAAJAAAACQAAAAkAAAAAAAAAAAAAAAAAAAAAEAAABQAAAAAAAAAAAA4D8AAAAAAADgPwAAAAAAAOA/AAAAAAAA4D8AAAAAAADgPwAAAAAAAOA/AAAAAAAA4D8AAAAAAADgPwAAAAAAAOA/AAAAAAAA4D8CAAAAjAAAAAAAAAAAAAAAQoX0DP///wgAAAAAAAAAAAAAAAAAAAAAAAAAAAAAAAAAAAAAZAAAAAEAAABAAAAAAAAAAAAAAAAAAAAAAAAAAAAAAAAAAAAAAAAAAAAAAAAAAAAAAAAAAAAAAAAAAAAAAAAAAAAAAAAAAAAAAAAAAAAAAAAAAAAAAAAAAAAAAAAAAAAAFAAAADwAAAAAAAAAAAAAAAAAAAkUAAAAAQAAABQAAAAUAAAAFAAAAAEAAAAAAAAAZAAAAGQAAAAAAAAAZAAAAGQAAAAVAAAAYAAAAAAAAAAAAAAADwAAACADAAAAAAAAAAAAAAEAAACgMgAAVgcAAKr4//8BAAAAf39/AAEAAABkAAAAAAAAABQAAABAHwAAAAAAACYAAAAAAAAAwOD//wAAAAAmAAAAZAAAABYAAABMAAAAAAAAAAAAAAAEAAAAAAAAAAEAAABZWVkKAAAAACgAAAAoAAAAZAAAAGQAAAAAAAAAzMzMAAAAAABQAAAAUAAAAGQAAABkAAAAAAAAABcAAAAUAAAAAAAAAAAAAAD/fwAA/38AAAAAAAAJAAAABAAAAGDhtuMeAAAAaAAAAAAAAAAAAAAAAAAAAAAAAAAAAAAAECcAABAnAAAAAAAAAAAAAAAAAAAAAAAAAAAAAAAAAAAAAAAAAAAAABQAAAAAAAAAwMD/AAAAAABkAAAAMgAAAAAAAABkAAAAAAAAAH9/fwAKAAAAIgAAABgAAAAAAAAAAAAAAAAAAAAAAAAAAAAAAAAAAAAkAAAAJAAAAAAAAAAHAAAAAAAAAAAAAAAAAAAAAAAAAAAAAAAAAAAAf39/ACUAAABYAAAAAAAAAAAAAAAAAAAAAAAAAAAAAAAAAAAAAAAAAAAAAAAAAAAAAAAAAAAAAAA/AAAAAAAAAKCGAQAAAAAAAAAAAAAAAAAMAAAAAQAAAAAAAAAAAAAAAAAAAB8AAABUAAAAAAAABQAAAAEAAAAAAAAAAAAAAAAAAAAAAAAAAAAAAAAAAAAAAAAAAAAAAAJ/f38AWVlZA8zMzADAwP8Af39/AAAAAAAAAAAAAAAAAAAAAAAAAAAAIQAAABgAAAAUAAAAFAMAALYCAAB/NwAAvwoAAAAAAAAmAAAACAAAAD0wAAAAAAAA"/>
+                <pr:smNativeData xmlns:pr="smNativeData" xmlns="smNativeData" val="SMDATA_15_LkR5ZhMAAAAlAAAAZAAAAA0AAAAAkAAAAJAAAACQAAAAkAAAAAAAAAAAAAAAAAAAAAEAAABQAAAAAAAAAAAA4D8AAAAAAADgPwAAAAAAAOA/AAAAAAAA4D8AAAAAAADgPwAAAAAAAOA/AAAAAAAA4D8AAAAAAADgPwAAAAAAAOA/AAAAAAAA4D8CAAAAjAAAAAAAAAAAAAAAQoX0DP///wgAAAAAAAAAAAAAAAAAAAAAAAAAAAAAAAAAAAAAZAAAAAEAAABAAAAAAAAAAAAAAAAAAAAAAAAAAAAAAAAAAAAAAAAAAAAAAAAAAAAAAAAAAAAAAAAAAAAAAAAAAAAAAAAAAAAAAAAAAAAAAAAAAAAAAAAAAAAAAAAAAAAAFAAAADwAAAAAAAAAAAAAAAAAAAkUAAAAAQAAABQAAAAUAAAAFAAAAAEAAAAAAAAAZAAAAGQAAAAAAAAAZAAAAGQAAAAVAAAAYAAAAAAAAAAAAAAADwAAACADAAAAAAAAAAAAAAEAAACgMgAAVgcAAKr4//8BAAAAf39/AAEAAABkAAAAAAAAABQAAABAHwAAAAAAACYAAAAAAAAAwOD//wAAAAAmAAAAZAAAABYAAABMAAAAAAAAAAAAAAAEAAAAAAAAAAEAAABZWVkKAAAAACgAAAAoAAAAZAAAAGQAAAAAAAAAzMzMAAAAAABQAAAAUAAAAGQAAABkAAAAAAAAABcAAAAUAAAAAAAAAAAAAAD/fwAA/38AAAAAAAAJAAAABAAAAGDhtuMeAAAAaAAAAAAAAAAAAAAAAAAAAAAAAAAAAAAAECcAABAnAAAAAAAAAAAAAAAAAAAAAAAAAAAAAAAAAAAAAAAAAAAAABQAAAAAAAAAwMD/AAAAAABkAAAAMgAAAAAAAABkAAAAAAAAAH9/fwAKAAAAIgAAABgAAAAAAAAAAAAAAAAAAAAAAAAAAAAAAAAAAAAkAAAAJAAAAAAAAAAHAAAAAAAAAAAAAAAAAAAAAAAAAAAAAAAAAAAAf39/ACUAAABYAAAAAAAAAAAAAAAAAAAAAAAAAAAAAAAAAAAAAAAAAAAAAAAAAAAAAAAAAAAAAAA/AAAAAAAAAKCGAQAAAAAAAAAAAAAAAAAMAAAAAQAAAAAAAAAAAAAAAAAAAB8AAABUAAAAAAAABQAAAAEAAAAAAAAAAAAAAAAAAAAAAAAAAAAAAAAAAAAAAAAAAAAAAAJ/f38AWVlZA8zMzADAwP8Af39/AAAAAAAAAAAAAAAAAAAAAAAAAAAAIQAAABgAAAAUAAAAFAMAALYCAAB/NwAAvwoAABAAAAAmAAAACAAAADwwAAAAAAAA"/>
               </a:ext>
             </a:extLst>
           </p:cNvSpPr>
@@ -14244,12 +13789,7 @@
             <p:ph type="title"/>
           </p:nvPr>
         </p:nvSpPr>
-        <p:spPr>
-          <a:xfrm>
-            <a:off x="500380" y="440690"/>
-            <a:ext cx="8521065" cy="1306195"/>
-          </a:xfrm>
-        </p:spPr>
+        <p:spPr/>
         <p:txBody>
           <a:bodyPr vert="horz" wrap="square" lIns="91440" tIns="91440" rIns="91440" bIns="91440" numCol="1" spcCol="215900" anchor="t">
             <a:prstTxWarp prst="textNoShape">
@@ -14284,7 +13824,7 @@
             <a:spLocks noGrp="1" noChangeArrowheads="1"/>
             <a:extLst>
               <a:ext uri="smNativeData">
-                <pr:smNativeData xmlns:pr="smNativeData" xmlns="smNativeData" val="SMDATA_15_EkJ5ZhMAAAAlAAAAZAAAAA0AAAAAkAAAAJAAAACQAAAAkAAAAAAAAAAAAAAAAAAAAAEAAABQAAAAAAAAAAAA4D8AAAAAAADgPwAAAAAAAOA/AAAAAAAA4D8AAAAAAADgPwAAAAAAAOA/AAAAAAAA4D8AAAAAAADgPwAAAAAAAOA/AAAAAAAA4D8CAAAAjAAAAAAAAAAAAAAAQoX0DP///wgAAAAAAAAAAAAAAAAAAAAAAAAAAAAAAAAAAAAAZAAAAAEAAABAAAAAAAAAAAAAAAAAAAAAAAAAAAAAAAAAAAAAAAAAAAAAAAAAAAAAAAAAAAAAAAAAAAAAAAAAAAAAAAAAAAAAAAAAAAAAAAAAAAAAAAAAAAAAAAAAAAAAFAAAADwAAAAAAAAAAAAAAAAAAAkUAAAAAQAAABQAAAAUAAAAFAAAAAEAAAAAAAAAZAAAAGQAAAAAAAAAZAAAAGQAAAAVAAAAYAAAAAAAAAAAAAAADwAAACADAAAAAAAAAAAAAAEAAACgMgAAVgcAAKr4//8BAAAAf39/AAEAAABkAAAAAAAAABQAAABAHwAAAAAAACYAAAAAAAAAwOD//wAAAAAmAAAAZAAAABYAAABMAAAAAAAAAAAAAAAEAAAAAAAAAAEAAABZWVkKAAAAACgAAAAoAAAAZAAAAGQAAAAAAAAAzMzMAAAAAABQAAAAUAAAAGQAAABkAAAAAAAAABcAAAAUAAAAAAAAAAAAAAD/fwAA/38AAAAAAAAJAAAABAAAAF8AYAAeAAAAaAAAAAAAAAAAAAAAAAAAAAAAAAAAAAAAECcAABAnAAAAAAAAAAAAAAAAAAAAAAAAAAAAAAAAAAAAAAAAAAAAABQAAAAAAAAAwMD/AAAAAABkAAAAMgAAAAAAAABkAAAAAAAAAH9/fwAKAAAAIgAAABgAAAAAAAAAAAAAAAAAAAAAAAAAAAAAAAAAAAAkAAAAJAAAAAAAAAAHAAAAAAAAAAAAAAAAAAAAAAAAAAAAAAAAAAAAf39/ACUAAABYAAAAAAAAAAAAAAAAAAAAAAAAAAAAAAAAAAAAAAAAAAAAAAAAAAAAAAAAAAAAAAA/AAAAAAAAAKCGAQAAAAAAAAAAAAAAAAAMAAAAAQAAAAAAAAAAAAAAAAAAAB8AAABUAAAAAAAABQAAAAEAAAAAAAAAAAAAAAAAAAAAAAAAAAAAAAAAAAAAAAAAAAAAAAJ/f38AWVlZA8zMzADAwP8Af39/AAAAAAAAAAAAAAAAAAAAAAAAAAAAIQAAABgAAAAUAAAAFAMAALMLAAB/NwAAuScAAAAAAAAmAAAACAAAAD0wAAAAAAAA"/>
+                <pr:smNativeData xmlns:pr="smNativeData" xmlns="smNativeData" val="SMDATA_15_LkR5ZhMAAAAlAAAAZAAAAA0AAAAAkAAAAJAAAACQAAAAkAAAAAAAAAAAAAAAAAAAAAEAAABQAAAAAAAAAAAA4D8AAAAAAADgPwAAAAAAAOA/AAAAAAAA4D8AAAAAAADgPwAAAAAAAOA/AAAAAAAA4D8AAAAAAADgPwAAAAAAAOA/AAAAAAAA4D8CAAAAjAAAAAAAAAAAAAAAQoX0DP///wgAAAAAAAAAAAAAAAAAAAAAAAAAAAAAAAAAAAAAZAAAAAEAAABAAAAAAAAAAAAAAAAAAAAAAAAAAAAAAAAAAAAAAAAAAAAAAAAAAAAAAAAAAAAAAAAAAAAAAAAAAAAAAAAAAAAAAAAAAAAAAAAAAAAAAAAAAAAAAAAAAAAAFAAAADwAAAAAAAAAAAAAAAAAAAkUAAAAAQAAABQAAAAUAAAAFAAAAAEAAAAAAAAAZAAAAGQAAAAAAAAAZAAAAGQAAAAVAAAAYAAAAAAAAAAAAAAADwAAACADAAAAAAAAAAAAAAEAAACgMgAAVgcAAKr4//8BAAAAf39/AAEAAABkAAAAAAAAABQAAABAHwAAAAAAACYAAAAAAAAAwOD//wAAAAAmAAAAZAAAABYAAABMAAAAAAAAAAAAAAAEAAAAAAAAAAEAAABZWVkKAAAAACgAAAAoAAAAZAAAAGQAAAAAAAAAzMzMAAAAAABQAAAAUAAAAGQAAABkAAAAAAAAABcAAAAUAAAAAAAAAAAAAAD/fwAA/38AAAAAAAAJAAAABAAAAF8AYAAeAAAAaAAAAAAAAAAAAAAAAAAAAAAAAAAAAAAAECcAABAnAAAAAAAAAAAAAAAAAAAAAAAAAAAAAAAAAAAAAAAAAAAAABQAAAAAAAAAwMD/AAAAAABkAAAAMgAAAAAAAABkAAAAAAAAAH9/fwAKAAAAIgAAABgAAAAAAAAAAAAAAAAAAAAAAAAAAAAAAAAAAAAkAAAAJAAAAAAAAAAHAAAAAAAAAAAAAAAAAAAAAAAAAAAAAAAAAAAAf39/ACUAAABYAAAAAAAAAAAAAAAAAAAAAAAAAAAAAAAAAAAAAAAAAAAAAAAAAAAAAAAAAAAAAAA/AAAAAAAAAKCGAQAAAAAAAAAAAAAAAAAMAAAAAQAAAAAAAAAAAAAAAAAAAB8AAABUAAAAAAAABQAAAAEAAAAAAAAAAAAAAAAAAAAAAAAAAAAAAAAAAAAAAAAAAAAAAAJ/f38AWVlZA8zMzADAwP8Af39/AAAAAAAAAAAAAAAAAAAAAAAAAAAAIQAAABgAAAAUAAAAFAMAALMLAAB/NwAAuScAABAAAAAmAAAACAAAADwwAAAAAAAA"/>
               </a:ext>
             </a:extLst>
           </p:cNvSpPr>
@@ -14292,12 +13832,7 @@
             <p:ph type="body" idx="1"/>
           </p:nvPr>
         </p:nvSpPr>
-        <p:spPr>
-          <a:xfrm>
-            <a:off x="500380" y="1901825"/>
-            <a:ext cx="8521065" cy="4555490"/>
-          </a:xfrm>
-        </p:spPr>
+        <p:spPr/>
         <p:txBody>
           <a:bodyPr vert="horz" wrap="square" lIns="91440" tIns="91440" rIns="91440" bIns="91440" numCol="1" spcCol="215900" anchor="t">
             <a:prstTxWarp prst="textNoShape">
@@ -14326,7 +13861,7 @@
             <a:picLocks noChangeAspect="1"/>
             <a:extLst>
               <a:ext uri="smNativeData">
-                <pr:smNativeData xmlns:pr="smNativeData" xmlns="smNativeData" val="SMDATA_17_EkJ5ZhMAAAAlAAAAEQAAAC8BAAAAkAAAAEgAAACQAAAASAAAAAAAAAAAAAAAAAAAAAEAAABQAAAAAAAAAAAA4D8AAAAAAADgPwAAAAAAAOA/AAAAAAAA4D8AAAAAAADgPwAAAAAAAOA/AAAAAAAA4D8AAAAAAADgPwAAAAAAAOA/AAAAAAAA4D8CAAAAjAAAAAAAAAAAAAAAQoX0DP///wgAAAAAAAAAAAAAAAAAAAAAAAAAAAAAAAAAAAAAZAAAAAEAAABAAAAAAAAAAAAAAAAAAAAAAAAAAAAAAAAAAAAAAAAAAAAAAAAAAAAAAAAAAAAAAAAAAAAAAAAAAAAAAAAAAAAAAAAAAAAAAAAAAAAAAAAAAAAAAAAAAAAAFAAAADwAAAAAAAAAAAAAAAAAAAkUAAAAAQAAABQAAAAUAAAAFAAAAAEAAAAAAAAAZAAAAGQAAAAAAAAAZAAAAGQAAAAVAAAAYAAAAAAAAAAAAAAADwAAACADAAAAAAAAAAAAAAEAAACgMgAAVgcAAKr4//8BAAAAf39/AAEAAABkAAAAAAAAABQAAABAHwAAAAAAACYAAAAAAAAAwOD//wAAAAAmAAAAZAAAABYAAABMAAAAAAAAAAAAAAAEAAAAAAAAAAEAAABZWVkKAAAAACgAAAAoAAAAZAAAAGQAAAAAAAAAzMzMAAAAAABQAAAAUAAAAGQAAABkAAAAAAAAAAcAAAA4AAAAAAAAAAAAAAAAAAAA////AAAAAAAAAAAAAAAAAAAAAAAAAAAAAAAAAAAAAABkAAAAZAAAAAAAAAAjAAAABAAAAGQAAAAXAAAAFAAAAAAAAAAAAAAA/38AAP9/AAAAAAAACQAAAAQAAAAOAAAAHgAAAGgAAAAAAAAAAAAAAAAAAAAAAAAAAAAAABAnAAAQJwAAAAAAAAAAAAAAAAAAAAAAAAAAAAAAAAAAAAAAAAAAAAAUAAAAAAAAAMDA/wAAAAAAZAAAADIAAAAAAAAAZAAAAAAAAAB/f38ACgAAACIAAAAYAAAAAAAAAAAAAAAAAAAAAAAAAAAAAAAAAAAAJAAAACQAAAAAAAAABwAAAAAAAAAAAAAAAAAAAAAAAAAAAAAAAAAAAH9/fwAlAAAAWAAAAAAAAAAAAAAAAAAAAAAAAAAAAAAAAAAAAAAAAAAAAAAAAAAAAAAAAAAAAAAAPwAAAAAAAACghgEAAAAAAAAAAAAAAAAADAAAAAEAAAAAAAAAAAAAAAAAAAAfAAAAVAAAAEKF9AX///8BAAAAAAAAAAAAAAAAAAAAAAAAAAAAAAAAAAAAAAAAAAAAAAACf39/AFlZWQPMzMwAwMD/AH9/fwAAAAAAAAAAAAAAAAD///8AAAAAACEAAAAYAAAAFAAAANwDAADmDgAAHSAAAMMlAAAAAAAAJgAAAAgAAAD//////////w=="/>
+                <pr:smNativeData xmlns:pr="smNativeData" xmlns="smNativeData" val="SMDATA_17_LkR5ZhMAAAAlAAAAEQAAAC8BAAAAkAAAAEgAAACQAAAASAAAAAAAAAAAAAAAAAAAAAEAAABQAAAAAAAAAAAA4D8AAAAAAADgPwAAAAAAAOA/AAAAAAAA4D8AAAAAAADgPwAAAAAAAOA/AAAAAAAA4D8AAAAAAADgPwAAAAAAAOA/AAAAAAAA4D8CAAAAjAAAAAAAAAAAAAAAQoX0DP///wgAAAAAAAAAAAAAAAAAAAAAAAAAAAAAAAAAAAAAZAAAAAEAAABAAAAAAAAAAAAAAAAAAAAAAAAAAAAAAAAAAAAAAAAAAAAAAAAAAAAAAAAAAAAAAAAAAAAAAAAAAAAAAAAAAAAAAAAAAAAAAAAAAAAAAAAAAAAAAAAAAAAAFAAAADwAAAAAAAAAAAAAAAAAAAkUAAAAAQAAABQAAAAUAAAAFAAAAAEAAAAAAAAAZAAAAGQAAAAAAAAAZAAAAGQAAAAVAAAAYAAAAAAAAAAAAAAADwAAACADAAAAAAAAAAAAAAEAAACgMgAAVgcAAKr4//8BAAAAf39/AAEAAABkAAAAAAAAABQAAABAHwAAAAAAACYAAAAAAAAAwOD//wAAAAAmAAAAZAAAABYAAABMAAAAAAAAAAAAAAAEAAAAAAAAAAEAAABZWVkKAAAAACgAAAAoAAAAZAAAAGQAAAAAAAAAzMzMAAAAAABQAAAAUAAAAGQAAABkAAAAAAAAAAcAAAA4AAAAAAAAAAAAAAAAAAAA////AAAAAAAAAAAAAAAAAAAAAAAAAAAAAAAAAAAAAABkAAAAZAAAAAAAAAAjAAAABAAAAGQAAAAXAAAAFAAAAAAAAAAAAAAA/38AAP9/AAAAAAAACQAAAAQAAAAOAAAAHgAAAGgAAAAAAAAAAAAAAAAAAAAAAAAAAAAAABAnAAAQJwAAAAAAAAAAAAAAAAAAAAAAAAAAAAAAAAAAAAAAAAAAAAAUAAAAAAAAAMDA/wAAAAAAZAAAADIAAAAAAAAAZAAAAAAAAAB/f38ACgAAACIAAAAYAAAAAAAAAAAAAAAAAAAAAAAAAAAAAAAAAAAAJAAAACQAAAAAAAAABwAAAAAAAAAAAAAAAAAAAAAAAAAAAAAAAAAAAH9/fwAlAAAAWAAAAAAAAAAAAAAAAAAAAAAAAAAAAAAAAAAAAAAAAAAAAAAAAAAAAAAAAAAAAAAAPwAAAAAAAACghgEAAAAAAAAAAAAAAAAADAAAAAEAAAAAAAAAAAAAAAAAAAAfAAAAVAAAAEKF9AX///8BAAAAAAAAAAAAAAAAAAAAAAAAAAAAAAAAAAAAAAAAAAAAAAACf39/AFlZWQPMzMwAwMD/AH9/fwAAAAAAAAAAAAAAAAD///8AAAAAACEAAAAYAAAAFAAAANwDAADmDgAAHSAAAMMlAAAQAAAAJgAAAAgAAAD//////////w=="/>
               </a:ext>
             </a:extLst>
           </p:cNvPicPr>
@@ -14392,7 +13927,7 @@
             <a:spLocks noGrp="1" noChangeArrowheads="1"/>
             <a:extLst>
               <a:ext uri="smNativeData">
-                <pr:smNativeData xmlns:pr="smNativeData" xmlns="smNativeData" val="SMDATA_15_EkJ5ZhMAAAAlAAAAZAAAAA0AAAAAkAAAAJAAAACQAAAAkAAAAAAAAAAAAAAAAAAAAAEAAABQAAAAAAAAAAAA4D8AAAAAAADgPwAAAAAAAOA/AAAAAAAA4D8AAAAAAADgPwAAAAAAAOA/AAAAAAAA4D8AAAAAAADgPwAAAAAAAOA/AAAAAAAA4D8CAAAAjAAAAAAAAAAAAAAAQoX0DP///wgAAAAAAAAAAAAAAAAAAAAAAAAAAAAAAAAAAAAAZAAAAAEAAABAAAAAAAAAAAAAAAAAAAAAAAAAAAAAAAAAAAAAAAAAAAAAAAAAAAAAAAAAAAAAAAAAAAAAAAAAAAAAAAAAAAAAAAAAAAAAAAAAAAAAAAAAAAAAAAAAAAAAFAAAADwAAAAAAAAAAAAAAAAAAAkUAAAAAQAAABQAAAAUAAAAFAAAAAEAAAAAAAAAZAAAAGQAAAAAAAAAZAAAAGQAAAAVAAAAYAAAAAAAAAAAAAAADwAAACADAAAAAAAAAAAAAAEAAACgMgAAVgcAAKr4//8BAAAAf39/AAEAAABkAAAAAAAAABQAAABAHwAAAAAAACYAAAAAAAAAwOD//wAAAAAmAAAAZAAAABYAAABMAAAAAAAAAAAAAAAEAAAAAAAAAAEAAABZWVkKAAAAACgAAAAoAAAAZAAAAGQAAAAAAAAAzMzMAAAAAABQAAAAUAAAAGQAAABkAAAAAAAAABcAAAAUAAAAAAAAAAAAAAD/fwAA/38AAAAAAAAJAAAABAAAAAAAAAAeAAAAaAAAAAAAAAAAAAAAAAAAAAAAAAAAAAAAECcAABAnAAAAAAAAAAAAAAAAAAAAAAAAAAAAAAAAAAAAAAAAAAAAABQAAAAAAAAAwMD/AAAAAABkAAAAMgAAAAAAAABkAAAAAAAAAH9/fwAKAAAAIgAAABgAAAAAAAAAAAAAAAAAAAAAAAAAAAAAAAAAAAAkAAAAJAAAAAAAAAAHAAAAAAAAAAAAAAAAAAAAAAAAAAAAAAAAAAAAf39/ACUAAABYAAAAAAAAAAAAAAAAAAAAAAAAAAAAAAAAAAAAAAAAAAAAAAAAAAAAAAAAAAAAAAA/AAAAAAAAAKCGAQAAAAAAAAAAAAAAAAAMAAAAAQAAAAAAAAAAAAAAAAAAAB8AAABUAAAAAAAABQAAAAEAAAAAAAAAAAAAAAAAAAAAAAAAAAAAAAAAAAAAAAAAAAAAAAJ/f38AWVlZA8zMzADAwP8Af39/AAAAAAAAAAAAAAAAAAAAAAAAAAAAIQAAABgAAAAUAAAAFAMAALYCAAB/NwAAvwoAAAAAAAAmAAAACAAAAAEAAAAAAAAA"/>
+                <pr:smNativeData xmlns:pr="smNativeData" xmlns="smNativeData" val="SMDATA_15_LkR5ZhMAAAAlAAAAZAAAAA0AAAAAkAAAAJAAAACQAAAAkAAAAAAAAAAAAAAAAAAAAAEAAABQAAAAAAAAAAAA4D8AAAAAAADgPwAAAAAAAOA/AAAAAAAA4D8AAAAAAADgPwAAAAAAAOA/AAAAAAAA4D8AAAAAAADgPwAAAAAAAOA/AAAAAAAA4D8CAAAAjAAAAAAAAAAAAAAAQoX0DP///wgAAAAAAAAAAAAAAAAAAAAAAAAAAAAAAAAAAAAAZAAAAAEAAABAAAAAAAAAAAAAAAAAAAAAAAAAAAAAAAAAAAAAAAAAAAAAAAAAAAAAAAAAAAAAAAAAAAAAAAAAAAAAAAAAAAAAAAAAAAAAAAAAAAAAAAAAAAAAAAAAAAAAFAAAADwAAAAAAAAAAAAAAAAAAAkUAAAAAQAAABQAAAAUAAAAFAAAAAEAAAAAAAAAZAAAAGQAAAAAAAAAZAAAAGQAAAAVAAAAYAAAAAAAAAAAAAAADwAAACADAAAAAAAAAAAAAAEAAACgMgAAVgcAAKr4//8BAAAAf39/AAEAAABkAAAAAAAAABQAAABAHwAAAAAAACYAAAAAAAAAwOD//wAAAAAmAAAAZAAAABYAAABMAAAAAAAAAAAAAAAEAAAAAAAAAAEAAABZWVkKAAAAACgAAAAoAAAAZAAAAGQAAAAAAAAAzMzMAAAAAABQAAAAUAAAAGQAAABkAAAAAAAAABcAAAAUAAAAAAAAAAAAAAD/fwAA/38AAAAAAAAJAAAABAAAAAAAAAAeAAAAaAAAAAAAAAAAAAAAAAAAAAAAAAAAAAAAECcAABAnAAAAAAAAAAAAAAAAAAAAAAAAAAAAAAAAAAAAAAAAAAAAABQAAAAAAAAAwMD/AAAAAABkAAAAMgAAAAAAAABkAAAAAAAAAH9/fwAKAAAAIgAAABgAAAAAAAAAAAAAAAAAAAAAAAAAAAAAAAAAAAAkAAAAJAAAAAAAAAAHAAAAAAAAAAAAAAAAAAAAAAAAAAAAAAAAAAAAf39/ACUAAABYAAAAAAAAAAAAAAAAAAAAAAAAAAAAAAAAAAAAAAAAAAAAAAAAAAAAAAAAAAAAAAA/AAAAAAAAAKCGAQAAAAAAAAAAAAAAAAAMAAAAAQAAAAAAAAAAAAAAAAAAAB8AAABUAAAAAAAABQAAAAEAAAAAAAAAAAAAAAAAAAAAAAAAAAAAAAAAAAAAAAAAAAAAAAJ/f38AWVlZA8zMzADAwP8Af39/AAAAAAAAAAAAAAAAAAAAAAAAAAAAIQAAABgAAAAUAAAAFAMAALYCAAB/NwAAvwoAABAAAAAmAAAACAAAAAAAAAAAAAAA"/>
               </a:ext>
             </a:extLst>
           </p:cNvSpPr>
@@ -14400,12 +13935,7 @@
             <p:ph type="title"/>
           </p:nvPr>
         </p:nvSpPr>
-        <p:spPr>
-          <a:xfrm>
-            <a:off x="500380" y="440690"/>
-            <a:ext cx="8521065" cy="1306195"/>
-          </a:xfrm>
-        </p:spPr>
+        <p:spPr/>
         <p:txBody>
           <a:bodyPr/>
           <a:lstStyle/>
@@ -14424,7 +13954,7 @@
             <a:spLocks noGrp="1" noChangeArrowheads="1"/>
             <a:extLst>
               <a:ext uri="smNativeData">
-                <pr:smNativeData xmlns:pr="smNativeData" xmlns="smNativeData" val="SMDATA_15_EkJ5ZhMAAAAlAAAAZAAAAA0AAAAAkAAAAJAAAACQAAAAkAAAAAAAAAAAAAAAAAAAAAEAAABQAAAAAAAAAAAA4D8AAAAAAADgPwAAAAAAAOA/AAAAAAAA4D8AAAAAAADgPwAAAAAAAOA/AAAAAAAA4D8AAAAAAADgPwAAAAAAAOA/AAAAAAAA4D8CAAAAjAAAAAAAAAAAAAAAQoX0DP///wgAAAAAAAAAAAAAAAAAAAAAAAAAAAAAAAAAAAAAZAAAAAEAAABAAAAAAAAAAAAAAAAAAAAAAAAAAAAAAAAAAAAAAAAAAAAAAAAAAAAAAAAAAAAAAAAAAAAAAAAAAAAAAAAAAAAAAAAAAAAAAAAAAAAAAAAAAAAAAAAAAAAAFAAAADwAAAAAAAAAAAAAAAAAAAkUAAAAAQAAABQAAAAUAAAAFAAAAAEAAAAAAAAAZAAAAGQAAAAAAAAAZAAAAGQAAAAVAAAAYAAAAAAAAAAAAAAADwAAACADAAAAAAAAAAAAAAEAAACgMgAAVgcAAKr4//8BAAAAf39/AAEAAABkAAAAAAAAABQAAABAHwAAAAAAACYAAAAAAAAAwOD//wAAAAAmAAAAZAAAABYAAABMAAAAAAAAAAAAAAAEAAAAAAAAAAEAAABZWVkKAAAAACgAAAAoAAAAZAAAAGQAAAAAAAAAzMzMAAAAAABQAAAAUAAAAGQAAABkAAAAAAAAABcAAAAUAAAAAAAAAAAAAAD/fwAA/38AAAAAAAAJAAAABAAAAAAAAAAeAAAAaAAAAAAAAAAAAAAAAAAAAAAAAAAAAAAAECcAABAnAAAAAAAAAAAAAAAAAAAAAAAAAAAAAAAAAAAAAAAAAAAAABQAAAAAAAAAwMD/AAAAAABkAAAAMgAAAAAAAABkAAAAAAAAAH9/fwAKAAAAIgAAABgAAAAAAAAAAAAAAAAAAAAAAAAAAAAAAAAAAAAkAAAAJAAAAAAAAAAHAAAAAAAAAAAAAAAAAAAAAAAAAAAAAAAAAAAAf39/ACUAAABYAAAAAAAAAAAAAAAAAAAAAAAAAAAAAAAAAAAAAAAAAAAAAAAAAAAAAAAAAAAAAAA/AAAAAAAAAKCGAQAAAAAAAAAAAAAAAAAMAAAAAQAAAAAAAAAAAAAAAAAAAB8AAABUAAAAAAAABQAAAAEAAAAAAAAAAAAAAAAAAAAAAAAAAAAAAAAAAAAAAAAAAAAAAAJ/f38AWVlZA8zMzADAwP8Af39/AAAAAAAAAAAAAAAAAAAAAAAAAAAAIQAAABgAAAAUAAAAFAMAALMLAAB/NwAAuScAAAAAAAAmAAAACAAAAAEAAAAAAAAA"/>
+                <pr:smNativeData xmlns:pr="smNativeData" xmlns="smNativeData" val="SMDATA_15_LkR5ZhMAAAAlAAAAZAAAAA0AAAAAkAAAAJAAAACQAAAAkAAAAAAAAAAAAAAAAAAAAAEAAABQAAAAAAAAAAAA4D8AAAAAAADgPwAAAAAAAOA/AAAAAAAA4D8AAAAAAADgPwAAAAAAAOA/AAAAAAAA4D8AAAAAAADgPwAAAAAAAOA/AAAAAAAA4D8CAAAAjAAAAAAAAAAAAAAAQoX0DP///wgAAAAAAAAAAAAAAAAAAAAAAAAAAAAAAAAAAAAAZAAAAAEAAABAAAAAAAAAAAAAAAAAAAAAAAAAAAAAAAAAAAAAAAAAAAAAAAAAAAAAAAAAAAAAAAAAAAAAAAAAAAAAAAAAAAAAAAAAAAAAAAAAAAAAAAAAAAAAAAAAAAAAFAAAADwAAAAAAAAAAAAAAAAAAAkUAAAAAQAAABQAAAAUAAAAFAAAAAEAAAAAAAAAZAAAAGQAAAAAAAAAZAAAAGQAAAAVAAAAYAAAAAAAAAAAAAAADwAAACADAAAAAAAAAAAAAAEAAACgMgAAVgcAAKr4//8BAAAAf39/AAEAAABkAAAAAAAAABQAAABAHwAAAAAAACYAAAAAAAAAwOD//wAAAAAmAAAAZAAAABYAAABMAAAAAAAAAAAAAAAEAAAAAAAAAAEAAABZWVkKAAAAACgAAAAoAAAAZAAAAGQAAAAAAAAAzMzMAAAAAABQAAAAUAAAAGQAAABkAAAAAAAAABcAAAAUAAAAAAAAAAAAAAD/fwAA/38AAAAAAAAJAAAABAAAAAAAAAAeAAAAaAAAAAAAAAAAAAAAAAAAAAAAAAAAAAAAECcAABAnAAAAAAAAAAAAAAAAAAAAAAAAAAAAAAAAAAAAAAAAAAAAABQAAAAAAAAAwMD/AAAAAABkAAAAMgAAAAAAAABkAAAAAAAAAH9/fwAKAAAAIgAAABgAAAAAAAAAAAAAAAAAAAAAAAAAAAAAAAAAAAAkAAAAJAAAAAAAAAAHAAAAAAAAAAAAAAAAAAAAAAAAAAAAAAAAAAAAf39/ACUAAABYAAAAAAAAAAAAAAAAAAAAAAAAAAAAAAAAAAAAAAAAAAAAAAAAAAAAAAAAAAAAAAA/AAAAAAAAAKCGAQAAAAAAAAAAAAAAAAAMAAAAAQAAAAAAAAAAAAAAAAAAAB8AAABUAAAAAAAABQAAAAEAAAAAAAAAAAAAAAAAAAAAAAAAAAAAAAAAAAAAAAAAAAAAAAJ/f38AWVlZA8zMzADAwP8Af39/AAAAAAAAAAAAAAAAAAAAAAAAAAAAIQAAABgAAAAUAAAAFAMAALMLAAB/NwAAuScAABAAAAAmAAAACAAAAAAAAAAAAAAA"/>
               </a:ext>
             </a:extLst>
           </p:cNvSpPr>
@@ -14432,12 +13962,7 @@
             <p:ph type="body" idx="1"/>
           </p:nvPr>
         </p:nvSpPr>
-        <p:spPr>
-          <a:xfrm>
-            <a:off x="500380" y="1901825"/>
-            <a:ext cx="8521065" cy="4555490"/>
-          </a:xfrm>
-        </p:spPr>
+        <p:spPr/>
         <p:txBody>
           <a:bodyPr/>
           <a:lstStyle/>
@@ -14462,7 +13987,7 @@
             <a:picLocks noChangeAspect="1"/>
             <a:extLst>
               <a:ext uri="smNativeData">
-                <pr:smNativeData xmlns:pr="smNativeData" xmlns="smNativeData" val="SMDATA_17_EkJ5ZhMAAAAlAAAAEQAAAC8BAAAAkAAAAEgAAACQAAAASAAAAAAAAAAAAAAAAAAAAAEAAABQAAAAAAAAAAAA4D8AAAAAAADgPwAAAAAAAOA/AAAAAAAA4D8AAAAAAADgPwAAAAAAAOA/AAAAAAAA4D8AAAAAAADgPwAAAAAAAOA/AAAAAAAA4D8CAAAAjAAAAAAAAAAAAAAAQoX0DP///wgAAAAAAAAAAAAAAAAAAAAAAAAAAAAAAAAAAAAAZAAAAAEAAABAAAAAAAAAAAAAAAAAAAAAAAAAAAAAAAAAAAAAAAAAAAAAAAAAAAAAAAAAAAAAAAAAAAAAAAAAAAAAAAAAAAAAAAAAAAAAAAAAAAAAAAAAAAAAAAAAAAAAFAAAADwAAAAAAAAAAAAAAAAAAAkUAAAAAQAAABQAAAAUAAAAFAAAAAEAAAAAAAAAZAAAAGQAAAAAAAAAZAAAAGQAAAAVAAAAYAAAAAAAAAAAAAAADwAAACADAAAAAAAAAAAAAAEAAACgMgAAVgcAAKr4//8BAAAAf39/AAEAAABkAAAAAAAAABQAAABAHwAAAAAAACYAAAAAAAAAwOD//wAAAAAmAAAAZAAAABYAAABMAAAAAAAAAAAAAAAEAAAAAAAAAAEAAABZWVkKAAAAACgAAAAoAAAAZAAAAGQAAAAAAAAAzMzMAAAAAABQAAAAUAAAAGQAAABkAAAAAAAAAAcAAAA4AAAAAAAAAAAAAAAAAAAA////AAAAAAAAAAAAAAAAAAAAAAAAAAAAAAAAAAAAAABkAAAAZAAAAAAAAAAjAAAABAAAAGQAAAAXAAAAFAAAAAAAAAAAAAAA/38AAP9/AAAAAAAACQAAAAQAAADFAAAAHgAAAGgAAAAAAAAAAAAAAAAAAAAAAAAAAAAAABAnAAAQJwAAAAAAAAAAAAAAAAAAAAAAAAAAAAAAAAAAAAAAAAAAAAAUAAAAAAAAAMDA/wAAAAAAZAAAADIAAAAAAAAAZAAAAAAAAAB/f38ACgAAACIAAAAYAAAAAAAAAAAAAAAAAAAAAAAAAAAAAAAAAAAAJAAAACQAAAAAAAAABwAAAAAAAAAAAAAAAAAAAAAAAAAAAAAAAAAAAH9/fwAlAAAAWAAAAAAAAAAAAAAAAAAAAAAAAAAAAAAAAAAAAAAAAAAAAAAAAAAAAAAAAAAAAAAAPwAAAAAAAACghgEAAAAAAAAAAAAAAAAADAAAAAEAAAAAAAAAAAAAAAAAAAAfAAAAVAAAAEKF9AX///8BAAAAAAAAAAAAAAAAAAAAAAAAAAAAAAAAAAAAAAAAAAAAAAACf39/AFlZWQPMzMwAwMD/AH9/fwAAAAAAAAAAAAAAAAD///8AAAAAACEAAAAYAAAAFAAAAO8DAACGDgAAOyMAAKQlAAAAAAAAJgAAAAgAAAD//////////w=="/>
+                <pr:smNativeData xmlns:pr="smNativeData" xmlns="smNativeData" val="SMDATA_17_LkR5ZhMAAAAlAAAAEQAAAC8BAAAAkAAAAEgAAACQAAAASAAAAAAAAAAAAAAAAAAAAAEAAABQAAAAAAAAAAAA4D8AAAAAAADgPwAAAAAAAOA/AAAAAAAA4D8AAAAAAADgPwAAAAAAAOA/AAAAAAAA4D8AAAAAAADgPwAAAAAAAOA/AAAAAAAA4D8CAAAAjAAAAAAAAAAAAAAAQoX0DP///wgAAAAAAAAAAAAAAAAAAAAAAAAAAAAAAAAAAAAAZAAAAAEAAABAAAAAAAAAAAAAAAAAAAAAAAAAAAAAAAAAAAAAAAAAAAAAAAAAAAAAAAAAAAAAAAAAAAAAAAAAAAAAAAAAAAAAAAAAAAAAAAAAAAAAAAAAAAAAAAAAAAAAFAAAADwAAAAAAAAAAAAAAAAAAAkUAAAAAQAAABQAAAAUAAAAFAAAAAEAAAAAAAAAZAAAAGQAAAAAAAAAZAAAAGQAAAAVAAAAYAAAAAAAAAAAAAAADwAAACADAAAAAAAAAAAAAAEAAACgMgAAVgcAAKr4//8BAAAAf39/AAEAAABkAAAAAAAAABQAAABAHwAAAAAAACYAAAAAAAAAwOD//wAAAAAmAAAAZAAAABYAAABMAAAAAAAAAAAAAAAEAAAAAAAAAAEAAABZWVkKAAAAACgAAAAoAAAAZAAAAGQAAAAAAAAAzMzMAAAAAABQAAAAUAAAAGQAAABkAAAAAAAAAAcAAAA4AAAAAAAAAAAAAAAAAAAA////AAAAAAAAAAAAAAAAAAAAAAAAAAAAAAAAAAAAAABkAAAAZAAAAAAAAAAjAAAABAAAAGQAAAAXAAAAFAAAAAAAAAAAAAAA/38AAP9/AAAAAAAACQAAAAQAAADFAAAAHgAAAGgAAAAAAAAAAAAAAAAAAAAAAAAAAAAAABAnAAAQJwAAAAAAAAAAAAAAAAAAAAAAAAAAAAAAAAAAAAAAAAAAAAAUAAAAAAAAAMDA/wAAAAAAZAAAADIAAAAAAAAAZAAAAAAAAAB/f38ACgAAACIAAAAYAAAAAAAAAAAAAAAAAAAAAAAAAAAAAAAAAAAAJAAAACQAAAAAAAAABwAAAAAAAAAAAAAAAAAAAAAAAAAAAAAAAAAAAH9/fwAlAAAAWAAAAAAAAAAAAAAAAAAAAAAAAAAAAAAAAAAAAAAAAAAAAAAAAAAAAAAAAAAAAAAAPwAAAAAAAACghgEAAAAAAAAAAAAAAAAADAAAAAEAAAAAAAAAAAAAAAAAAAAfAAAAVAAAAEKF9AX///8BAAAAAAAAAAAAAAAAAAAAAAAAAAAAAAAAAAAAAAAAAAAAAAACf39/AFlZWQPMzMwAwMD/AH9/fwAAAAAAAAAAAAAAAAD///8AAAAAACEAAAAYAAAAFAAAAO8DAACGDgAAOyMAAKQlAAAQAAAAJgAAAAgAAAD//////////w=="/>
               </a:ext>
             </a:extLst>
           </p:cNvPicPr>
@@ -14757,6 +14282,47 @@
   <a:extraClrSchemeLst>
     <a:extraClrScheme>
       <a:clrScheme name="Presentation 1">
+        <a:dk1>
+          <a:srgbClr val="000000"/>
+        </a:dk1>
+        <a:lt1>
+          <a:srgbClr val="FFFFFF"/>
+        </a:lt1>
+        <a:dk2>
+          <a:srgbClr val="EEEEEE"/>
+        </a:dk2>
+        <a:lt2>
+          <a:srgbClr val="595959"/>
+        </a:lt2>
+        <a:accent1>
+          <a:srgbClr val="4285F4"/>
+        </a:accent1>
+        <a:accent2>
+          <a:srgbClr val="212121"/>
+        </a:accent2>
+        <a:accent3>
+          <a:srgbClr val="78909C"/>
+        </a:accent3>
+        <a:accent4>
+          <a:srgbClr val="FFAB40"/>
+        </a:accent4>
+        <a:accent5>
+          <a:srgbClr val="0097A7"/>
+        </a:accent5>
+        <a:accent6>
+          <a:srgbClr val="EEFF41"/>
+        </a:accent6>
+        <a:hlink>
+          <a:srgbClr val="0097A7"/>
+        </a:hlink>
+        <a:folHlink>
+          <a:srgbClr val="0097A7"/>
+        </a:folHlink>
+      </a:clrScheme>
+      <a:clrMap bg1="lt1" tx1="dk1" bg2="lt2" tx2="dk2" accent1="accent1" accent2="accent2" accent3="accent3" accent4="accent4" accent5="accent5" accent6="accent6" hlink="hlink" folHlink="folHlink"/>
+    </a:extraClrScheme>
+    <a:extraClrScheme>
+      <a:clrScheme name="Presentation 2">
         <a:dk1>
           <a:srgbClr val="000000"/>
         </a:dk1>
@@ -15092,13 +14658,54 @@
       </a:clrScheme>
       <a:clrMap bg1="lt1" tx1="dk1" bg2="lt2" tx2="dk2" accent1="accent1" accent2="accent2" accent3="accent3" accent4="accent4" accent5="accent5" accent6="accent6" hlink="hlink" folHlink="folHlink"/>
     </a:extraClrScheme>
+    <a:extraClrScheme>
+      <a:clrScheme name="Presentation 2">
+        <a:dk1>
+          <a:srgbClr val="000000"/>
+        </a:dk1>
+        <a:lt1>
+          <a:srgbClr val="FFFFFF"/>
+        </a:lt1>
+        <a:dk2>
+          <a:srgbClr val="F3F3F3"/>
+        </a:dk2>
+        <a:lt2>
+          <a:srgbClr val="158158"/>
+        </a:lt2>
+        <a:accent1>
+          <a:srgbClr val="058DC7"/>
+        </a:accent1>
+        <a:accent2>
+          <a:srgbClr val="50B432"/>
+        </a:accent2>
+        <a:accent3>
+          <a:srgbClr val="ED561B"/>
+        </a:accent3>
+        <a:accent4>
+          <a:srgbClr val="EDEF00"/>
+        </a:accent4>
+        <a:accent5>
+          <a:srgbClr val="24CBE5"/>
+        </a:accent5>
+        <a:accent6>
+          <a:srgbClr val="64E572"/>
+        </a:accent6>
+        <a:hlink>
+          <a:srgbClr val="2200CC"/>
+        </a:hlink>
+        <a:folHlink>
+          <a:srgbClr val="551A8B"/>
+        </a:folHlink>
+      </a:clrScheme>
+      <a:clrMap bg1="lt1" tx1="dk1" bg2="lt2" tx2="dk2" accent1="accent1" accent2="accent2" accent3="accent3" accent4="accent4" accent5="accent5" accent6="accent6" hlink="hlink" folHlink="folHlink"/>
+    </a:extraClrScheme>
   </a:extraClrSchemeLst>
 </a:theme>
 </file>
 
 <file path=ppt/theme/themeOverride1.xml><?xml version="1.0" encoding="utf-8"?>
 <a:themeOverride xmlns:a="http://schemas.openxmlformats.org/drawingml/2006/main">
-  <a:clrScheme name="Presentation">
+  <a:clrScheme name="Presentation 1">
     <a:dk1>
       <a:srgbClr val="000000"/>
     </a:dk1>
@@ -15141,7 +14748,7 @@
 
 <file path=ppt/theme/themeOverride10.xml><?xml version="1.0" encoding="utf-8"?>
 <a:themeOverride xmlns:a="http://schemas.openxmlformats.org/drawingml/2006/main">
-  <a:clrScheme name="Presentation">
+  <a:clrScheme name="Presentation 1">
     <a:dk1>
       <a:srgbClr val="000000"/>
     </a:dk1>
@@ -15184,7 +14791,7 @@
 
 <file path=ppt/theme/themeOverride11.xml><?xml version="1.0" encoding="utf-8"?>
 <a:themeOverride xmlns:a="http://schemas.openxmlformats.org/drawingml/2006/main">
-  <a:clrScheme name="Presentation">
+  <a:clrScheme name="Presentation 1">
     <a:dk1>
       <a:srgbClr val="000000"/>
     </a:dk1>
@@ -15227,50 +14834,7 @@
 
 <file path=ppt/theme/themeOverride12.xml><?xml version="1.0" encoding="utf-8"?>
 <a:themeOverride xmlns:a="http://schemas.openxmlformats.org/drawingml/2006/main">
-  <a:clrScheme name="Presentation">
-    <a:dk1>
-      <a:srgbClr val="000000"/>
-    </a:dk1>
-    <a:lt1>
-      <a:srgbClr val="FFFFFF"/>
-    </a:lt1>
-    <a:dk2>
-      <a:srgbClr val="158158"/>
-    </a:dk2>
-    <a:lt2>
-      <a:srgbClr val="F3F3F3"/>
-    </a:lt2>
-    <a:accent1>
-      <a:srgbClr val="058DC7"/>
-    </a:accent1>
-    <a:accent2>
-      <a:srgbClr val="50B432"/>
-    </a:accent2>
-    <a:accent3>
-      <a:srgbClr val="ED561B"/>
-    </a:accent3>
-    <a:accent4>
-      <a:srgbClr val="EDEF00"/>
-    </a:accent4>
-    <a:accent5>
-      <a:srgbClr val="24CBE5"/>
-    </a:accent5>
-    <a:accent6>
-      <a:srgbClr val="64E572"/>
-    </a:accent6>
-    <a:hlink>
-      <a:srgbClr val="2200CC"/>
-    </a:hlink>
-    <a:folHlink>
-      <a:srgbClr val="551A8B"/>
-    </a:folHlink>
-  </a:clrScheme>
-</a:themeOverride>
-</file>
-
-<file path=ppt/theme/themeOverride13.xml><?xml version="1.0" encoding="utf-8"?>
-<a:themeOverride xmlns:a="http://schemas.openxmlformats.org/drawingml/2006/main">
-  <a:clrScheme name="Presentation">
+  <a:clrScheme name="Presentation 1">
     <a:dk1>
       <a:srgbClr val="000000"/>
     </a:dk1>
@@ -15313,7 +14877,7 @@
 
 <file path=ppt/theme/themeOverride2.xml><?xml version="1.0" encoding="utf-8"?>
 <a:themeOverride xmlns:a="http://schemas.openxmlformats.org/drawingml/2006/main">
-  <a:clrScheme name="Presentation">
+  <a:clrScheme name="Presentation 1">
     <a:dk1>
       <a:srgbClr val="000000"/>
     </a:dk1>
@@ -15356,7 +14920,7 @@
 
 <file path=ppt/theme/themeOverride3.xml><?xml version="1.0" encoding="utf-8"?>
 <a:themeOverride xmlns:a="http://schemas.openxmlformats.org/drawingml/2006/main">
-  <a:clrScheme name="Presentation">
+  <a:clrScheme name="Presentation 1">
     <a:dk1>
       <a:srgbClr val="000000"/>
     </a:dk1>
@@ -15399,7 +14963,7 @@
 
 <file path=ppt/theme/themeOverride4.xml><?xml version="1.0" encoding="utf-8"?>
 <a:themeOverride xmlns:a="http://schemas.openxmlformats.org/drawingml/2006/main">
-  <a:clrScheme name="Presentation">
+  <a:clrScheme name="Presentation 1">
     <a:dk1>
       <a:srgbClr val="000000"/>
     </a:dk1>
@@ -15442,7 +15006,7 @@
 
 <file path=ppt/theme/themeOverride5.xml><?xml version="1.0" encoding="utf-8"?>
 <a:themeOverride xmlns:a="http://schemas.openxmlformats.org/drawingml/2006/main">
-  <a:clrScheme name="Presentation">
+  <a:clrScheme name="Presentation 1">
     <a:dk1>
       <a:srgbClr val="000000"/>
     </a:dk1>
@@ -15485,7 +15049,7 @@
 
 <file path=ppt/theme/themeOverride6.xml><?xml version="1.0" encoding="utf-8"?>
 <a:themeOverride xmlns:a="http://schemas.openxmlformats.org/drawingml/2006/main">
-  <a:clrScheme name="Presentation">
+  <a:clrScheme name="Presentation 1">
     <a:dk1>
       <a:srgbClr val="000000"/>
     </a:dk1>
@@ -15528,7 +15092,7 @@
 
 <file path=ppt/theme/themeOverride7.xml><?xml version="1.0" encoding="utf-8"?>
 <a:themeOverride xmlns:a="http://schemas.openxmlformats.org/drawingml/2006/main">
-  <a:clrScheme name="Presentation">
+  <a:clrScheme name="Presentation 1">
     <a:dk1>
       <a:srgbClr val="000000"/>
     </a:dk1>
@@ -15571,7 +15135,7 @@
 
 <file path=ppt/theme/themeOverride8.xml><?xml version="1.0" encoding="utf-8"?>
 <a:themeOverride xmlns:a="http://schemas.openxmlformats.org/drawingml/2006/main">
-  <a:clrScheme name="Presentation">
+  <a:clrScheme name="Presentation 1">
     <a:dk1>
       <a:srgbClr val="000000"/>
     </a:dk1>
@@ -15614,7 +15178,7 @@
 
 <file path=ppt/theme/themeOverride9.xml><?xml version="1.0" encoding="utf-8"?>
 <a:themeOverride xmlns:a="http://schemas.openxmlformats.org/drawingml/2006/main">
-  <a:clrScheme name="Presentation">
+  <a:clrScheme name="Presentation 1">
     <a:dk1>
       <a:srgbClr val="000000"/>
     </a:dk1>

--- a/project/Защита_проекта_Микросервис_на_основе_Apache_Kafka.pptx
+++ b/project/Защита_проекта_Микросервис_на_основе_Apache_Kafka.pptx
@@ -270,7 +270,7 @@
             <a:spLocks noGrp="1" noChangeArrowheads="1"/>
             <a:extLst>
               <a:ext uri="smNativeData">
-                <pr:smNativeData xmlns:pr="smNativeData" xmlns="smNativeData" val="SMDATA_15_LkR5ZhMAAAAlAAAACwAAAA0AAAAACAcAADgEAAAoIwAAUBkAAAAAAAAAAAAAAAAAAAEAAABQAAAAAAAAAAAA4D8AAAAAAADgPwAAAAAAAOA/AAAAAAAA4D8AAAAAAADgPwAAAAAAAOA/AAAAAAAA4D8AAAAAAADgPwAAAAAAAOA/AAAAAAAA4D8CAAAAjAAAAAAAAAAAAAAABY3HDP///wgAAAAAAAAAAAAAAAAAAAAAAAAAAAAAAAAAAAAAZAAAAAEAAABAAAAAAAAAAAAAAAAAAAAAAAAAAAAAAAAAAAAAAAAAAAAAAAAAAAAAAAAAAAAAAAAAAAAAAAAAAAAAAAAAAAAAAAAAAAAAAAAAAAAAAAAAAAAAAAAAAAAAFAAAADwAAAABAAAAAAAAAAAAAAAPAAAAAQAAACMAAAAjAAAAIwAAAB4AAAAAAAAASwAAAEsAAAAAAAAASwAAAEsAAAAVAAAAYAAAAAAAAAAAAAAADwAAACADAAAAAAAAAAAAAAEAAACgMgAAVgcAAKr4//8BAAAAf39/AAEAAABkAAAAAAAAABQAAABAHwAAAAAAACYAAAAAAAAAwOD//wAAAAAmAAAAZAAAABYAAABMAAAAAAAAAAAAAAAEAAAAAAAAAAEAAAAVgVgKAAAAACgAAAAoAAAAZAAAAGQAAAAAAAAAzMzMAAAAAABQAAAAUAAAAGQAAABkAAAAAAAAABcAAAAUAAAAAAAAAAAAAAD/fwAA/38AAAAAAAAJAAAABAAAACwAAAAeAAAAaAAAAAAAAAAAAAAAAAAAAAAAAAAAAAAAECcAABAnAAAAAAAAAAAAAAAAAAAAAAAAAAAAAAAAAAAAAAAAAAAAABQAAAAAAAAAwMD/AAAAAABkAAAAMgAAAAAAAABkAAAAAAAAAH9/fwAKAAAAIgAAABgAAAAAAAAAAAAAAAAAAAAAAAAAAAAAAAAAAAAkAAAAJAAAAAAAAAAHAAAAAAAAAAAAAAAAAAAAAAAAAAAAAAAAAAAAf39/ACUAAABYAAAAAAAAAAAAAAAAAAAAAAAAAAAAAAAAAAAAAAAAAAAAAAAAAAAAAAAAAAAAAAA/AAAAAAAAAKCGAQAAAAAAAAAAAAAAAAAMAAAAAQAAAAAAAAAAAAAAAAAAAB8AAABUAAAAAAAABQAAAAEAAAAAAAAAAAAAAAAAAAAAAAAAAAAAAAAAAAAAAAAAAAAAAAB/f38AAAAAA8zMzADAwP8Af39/AAAAAAAAAAAAAAAAAAAAAAAAAAAAIQAAABgAAAAUAAAACAcAADgEAAAoIwAAUBkAABAAAAAmAAAACAAAAAEPAAD/HwAA"/>
+                <pr:smNativeData xmlns:pr="smNativeData" xmlns="smNativeData" val="SMDATA_15_FUV5ZhMAAAAlAAAACwAAAA0AAAAACAcAADgEAAAoIwAAUBkAAAAAAAAAAAAAAAAAAAEAAABQAAAAAAAAAAAA4D8AAAAAAADgPwAAAAAAAOA/AAAAAAAA4D8AAAAAAADgPwAAAAAAAOA/AAAAAAAA4D8AAAAAAADgPwAAAAAAAOA/AAAAAAAA4D8CAAAAjAAAAAAAAAAAAAAABY3HDP///wgAAAAAAAAAAAAAAAAAAAAAAAAAAAAAAAAAAAAAZAAAAAEAAABAAAAAAAAAAAAAAAAAAAAAAAAAAAAAAAAAAAAAAAAAAAAAAAAAAAAAAAAAAAAAAAAAAAAAAAAAAAAAAAAAAAAAAAAAAAAAAAAAAAAAAAAAAAAAAAAAAAAAFAAAADwAAAABAAAAAAAAAAAAAAAPAAAAAQAAACMAAAAjAAAAIwAAAB4AAAAAAAAASwAAAEsAAAAAAAAASwAAAEsAAAAVAAAAYAAAAAAAAAAAAAAADwAAACADAAAAAAAAAAAAAAEAAACgMgAAVgcAAKr4//8BAAAAf39/AAEAAABkAAAAAAAAABQAAABAHwAAAAAAACYAAAAAAAAAwOD//wAAAAAmAAAAZAAAABYAAABMAAAAAAAAAAAAAAAEAAAAAAAAAAEAAAAVgVgKAAAAACgAAAAoAAAAZAAAAGQAAAAAAAAAzMzMAAAAAABQAAAAUAAAAGQAAABkAAAAAAAAABcAAAAUAAAAAAAAAAAAAAD/fwAA/38AAAAAAAAJAAAABAAAACwAAAAeAAAAaAAAAAAAAAAAAAAAAAAAAAAAAAAAAAAAECcAABAnAAAAAAAAAAAAAAAAAAAAAAAAAAAAAAAAAAAAAAAAAAAAABQAAAAAAAAAwMD/AAAAAABkAAAAMgAAAAAAAABkAAAAAAAAAH9/fwAKAAAAIgAAABgAAAAAAAAAAAAAAAAAAAAAAAAAAAAAAAAAAAAkAAAAJAAAAAAAAAAHAAAAAAAAAAAAAAAAAAAAAAAAAAAAAAAAAAAAf39/ACUAAABYAAAAAAAAAAAAAAAAAAAAAAAAAAAAAAAAAAAAAAAAAAAAAAAAAAAAAAAAAAAAAAA/AAAAAAAAAKCGAQAAAAAAAAAAAAAAAAAMAAAAAQAAAAAAAAAAAAAAAAAAAB8AAABUAAAAAAAABQAAAAEAAAAAAAAAAAAAAAAAAAAAAAAAAAAAAAAAAAAAAAAAAAAAAAB/f38AAAAAA8zMzADAwP8Af39/AAAAAAAAAAAAAAAAAAAAAAAAAAAAIQAAABgAAAAUAAAACAcAADgEAAAoIwAAUBkAABAAAAAmAAAACAAAAAEPAAD/HwAA"/>
               </a:ext>
             </a:extLst>
           </p:cNvSpPr>
@@ -325,7 +325,7 @@
             <a:spLocks noGrp="1" noChangeArrowheads="1"/>
             <a:extLst>
               <a:ext uri="smNativeData">
-                <pr:smNativeData xmlns:pr="smNativeData" xmlns="smNativeData" val="SMDATA_15_LkR5ZhMAAAAlAAAAZAAAAA0AAAAAkAAAAJAAAACQAAAAkAAAAAAAAAAAAAAAAAAAAAEAAABQAAAAAAAAAAAA4D8AAAAAAADgPwAAAAAAAOA/AAAAAAAA4D8AAAAAAADgPwAAAAAAAOA/AAAAAAAA4D8AAAAAAADgPwAAAAAAAOA/AAAAAAAA4D8CAAAAjAAAAAAAAAAAAAAABY3HDP///wgAAAAAAAAAAAAAAAAAAAAAAAAAAAAAAAAAAAAAZAAAAAEAAABAAAAAAAAAAAAAAAAAAAAAAAAAAAAAAAAAAAAAAAAAAAAAAAAAAAAAAAAAAAAAAAAAAAAAAAAAAAAAAAAAAAAAAAAAAAAAAAAAAAAAAAAAAAAAAAAAAAAAFAAAADwAAAAAAAAAAAAAAAAAAAkUAAAAAQAAABQAAAAUAAAAFAAAAAEAAAAAAAAAZAAAAGQAAAAAAAAAZAAAAGQAAAAVAAAAYAAAAAAAAAAAAAAADwAAACADAAAAAAAAAAAAAAEAAACgMgAAVgcAAKr4//8BAAAAf39/AAEAAABkAAAAAAAAABQAAABAHwAAAAAAACYAAAAAAAAAwOD//wAAAAAmAAAAZAAAABYAAABMAAAAAAAAAAAAAAAEAAAAAAAAAAEAAAAVgVgKAAAAACgAAAAoAAAAZAAAAGQAAAAAAAAAzMzMAAAAAABQAAAAUAAAAGQAAABkAAAAAAAAABcAAAAUAAAAAAAAAAAAAAD/fwAA/38AAAAAAAAJAAAABAAAAHsAfAAeAAAAaAAAAAAAAAAAAAAAAAAAAAAAAAAAAAAAECcAABAnAAAAAAAAAAAAAAAAAAAAAAAAAAAAAAAAAAAAAAAAAAAAABQAAAAAAAAAwMD/AAAAAABkAAAAMgAAAAAAAABkAAAAAAAAAH9/fwAKAAAAIgAAABgAAAAAAAAAAAAAAAAAAAAAAAAAAAAAAAAAAAAkAAAAJAAAAAAAAAAHAAAAAAAAAAAAAAAAAAAAAAAAAAAAAAAAAAAAf39/ACUAAABYAAAAAAAAAAAAAAAAAAAAAAAAAAAAAAAAAAAAAAAAAAAAAAAAAAAAAAAAAAAAAAA/AAAAAAAAAKCGAQAAAAAAAAAAAAAAAAAMAAAAAQAAAAAAAAAAAAAAAAAAAB8AAABUAAAAAAAABQAAAAEAAAAAAAAAAAAAAAAAAAAAAAAAAAAAAAAAAAAAAAAAAAAAAAJ/f38AAAAAA8zMzADAwP8Af39/AAAAAAAAAAAAAAAAAAAAAAAAAAAAIQAAABgAAAAUAAAAOAQAALgaAAD4JQAACDQAABAAAAAmAAAACAAAAL2/AAD/HwAA"/>
+                <pr:smNativeData xmlns:pr="smNativeData" xmlns="smNativeData" val="SMDATA_15_FUV5ZhMAAAAlAAAAZAAAAA0AAAAAkAAAAJAAAACQAAAAkAAAAAAAAAAAAAAAAAAAAAEAAABQAAAAAAAAAAAA4D8AAAAAAADgPwAAAAAAAOA/AAAAAAAA4D8AAAAAAADgPwAAAAAAAOA/AAAAAAAA4D8AAAAAAADgPwAAAAAAAOA/AAAAAAAA4D8CAAAAjAAAAAAAAAAAAAAABY3HDP///wgAAAAAAAAAAAAAAAAAAAAAAAAAAAAAAAAAAAAAZAAAAAEAAABAAAAAAAAAAAAAAAAAAAAAAAAAAAAAAAAAAAAAAAAAAAAAAAAAAAAAAAAAAAAAAAAAAAAAAAAAAAAAAAAAAAAAAAAAAAAAAAAAAAAAAAAAAAAAAAAAAAAAFAAAADwAAAAAAAAAAAAAAAAAAAkUAAAAAQAAABQAAAAUAAAAFAAAAAEAAAAAAAAAZAAAAGQAAAAAAAAAZAAAAGQAAAAVAAAAYAAAAAAAAAAAAAAADwAAACADAAAAAAAAAAAAAAEAAACgMgAAVgcAAKr4//8BAAAAf39/AAEAAABkAAAAAAAAABQAAABAHwAAAAAAACYAAAAAAAAAwOD//wAAAAAmAAAAZAAAABYAAABMAAAAAAAAAAAAAAAEAAAAAAAAAAEAAAAVgVgKAAAAACgAAAAoAAAAZAAAAGQAAAAAAAAAzMzMAAAAAABQAAAAUAAAAGQAAABkAAAAAAAAABcAAAAUAAAAAAAAAAAAAAD/fwAA/38AAAAAAAAJAAAABAAAAHsAfAAeAAAAaAAAAAAAAAAAAAAAAAAAAAAAAAAAAAAAECcAABAnAAAAAAAAAAAAAAAAAAAAAAAAAAAAAAAAAAAAAAAAAAAAABQAAAAAAAAAwMD/AAAAAABkAAAAMgAAAAAAAABkAAAAAAAAAH9/fwAKAAAAIgAAABgAAAAAAAAAAAAAAAAAAAAAAAAAAAAAAAAAAAAkAAAAJAAAAAAAAAAHAAAAAAAAAAAAAAAAAAAAAAAAAAAAAAAAAAAAf39/ACUAAABYAAAAAAAAAAAAAAAAAAAAAAAAAAAAAAAAAAAAAAAAAAAAAAAAAAAAAAAAAAAAAAA/AAAAAAAAAKCGAQAAAAAAAAAAAAAAAAAMAAAAAQAAAAAAAAAAAAAAAAAAAB8AAABUAAAAAAAABQAAAAEAAAAAAAAAAAAAAAAAAAAAAAAAAAAAAAAAAAAAAAAAAAAAAAJ/f38AAAAAA8zMzADAwP8Af39/AAAAAAAAAAAAAAAAAAAAAAAAAAAAIQAAABgAAAAUAAAAOAQAALgaAAD4JQAACDQAABAAAAAmAAAACAAAAL2/AAD/HwAA"/>
               </a:ext>
             </a:extLst>
           </p:cNvSpPr>
@@ -697,7 +697,7 @@
             <a:spLocks noGrp="1" noChangeArrowheads="1"/>
             <a:extLst>
               <a:ext uri="smNativeData">
-                <pr:smNativeData xmlns:pr="smNativeData" xmlns="smNativeData" val="SMDATA_15_LkR5ZhMAAAAlAAAACwAAAA0AAAAACAcAADgEAAAoIwAAUBkAAAAAAAAAAAAAAAAAAAEAAABQAAAAAAAAAAAA4D8AAAAAAADgPwAAAAAAAOA/AAAAAAAA4D8AAAAAAADgPwAAAAAAAOA/AAAAAAAA4D8AAAAAAADgPwAAAAAAAOA/AAAAAAAA4D8CAAAAjAAAAAAAAAAAAAAAQoX0DP///wgAAAAAAAAAAAAAAAAAAAAAAAAAAAAAAAAAAAAAZAAAAAEAAABAAAAAAAAAAAAAAAAAAAAAAAAAAAAAAAAAAAAAAAAAAAAAAAAAAAAAAAAAAAAAAAAAAAAAAAAAAAAAAAAAAAAAAAAAAAAAAAAAAAAAAAAAAAAAAAAAAAAAFAAAADwAAAABAAAAAAAAAAAAAAAPAAAAAQAAACMAAAAjAAAAIwAAAB4AAAAAAAAASwAAAEsAAAAAAAAASwAAAEsAAAAVAAAAYAAAAAAAAAAAAAAADwAAACADAAAAAAAAAAAAAAEAAACgMgAAVgcAAKr4//8BAAAAf39/AAEAAABkAAAAAAAAABQAAABAHwAAAAAAACYAAAAAAAAAwOD//wAAAAAmAAAAZAAAABYAAABMAAAAAAAAAAAAAAAEAAAAAAAAAAEAAABZWVkKAAAAACgAAAAoAAAAZAAAAGQAAAAAAAAAzMzMAAAAAABQAAAAUAAAAGQAAABkAAAAAAAAABcAAAAUAAAAAAAAAAAAAAD/fwAA/38AAAAAAAAJAAAABAAAAAAAAAAeAAAAaAAAAAAAAAAAAAAAAAAAAAAAAAAAAAAAECcAABAnAAAAAAAAAAAAAAAAAAAAAAAAAAAAAAAAAAAAAAAAAAAAABQAAAAAAAAAwMD/AAAAAABkAAAAMgAAAAAAAABkAAAAAAAAAH9/fwAKAAAAIgAAABgAAAAAAAAAAAAAAAAAAAAAAAAAAAAAAAAAAAAkAAAAJAAAAAAAAAAHAAAAAAAAAAAAAAAAAAAAAAAAAAAAAAAAAAAAf39/ACUAAABYAAAAAAAAAAAAAAAAAAAAAAAAAAAAAAAAAAAAAAAAAAAAAAAAAAAAAAAAAAAAAAA/AAAAAAAAAKCGAQAAAAAAAAAAAAAAAAAMAAAAAQAAAAAAAAAAAAAAAAAAAB8AAABUAAAAAAAABQAAAAEAAAAAAAAAAAAAAAAAAAAAAAAAAAAAAAAAAAAAAAAAAAAAAAB/f38AAAAAA8zMzADAwP8Af39/AAAAAAAAAAAAAAAAAAAAAAAAAAAAIQAAABgAAAAUAAAACAcAADgEAAAoIwAAUBkAABAAAAAmAAAACAAAAAEPAAAAAAAA"/>
+                <pr:smNativeData xmlns:pr="smNativeData" xmlns="smNativeData" val="SMDATA_15_FUV5ZhMAAAAlAAAACwAAAA0AAAAACAcAADgEAAAoIwAAUBkAAAAAAAAAAAAAAAAAAAEAAABQAAAAAAAAAAAA4D8AAAAAAADgPwAAAAAAAOA/AAAAAAAA4D8AAAAAAADgPwAAAAAAAOA/AAAAAAAA4D8AAAAAAADgPwAAAAAAAOA/AAAAAAAA4D8CAAAAjAAAAAAAAAAAAAAAQoX0DP///wgAAAAAAAAAAAAAAAAAAAAAAAAAAAAAAAAAAAAAZAAAAAEAAABAAAAAAAAAAAAAAAAAAAAAAAAAAAAAAAAAAAAAAAAAAAAAAAAAAAAAAAAAAAAAAAAAAAAAAAAAAAAAAAAAAAAAAAAAAAAAAAAAAAAAAAAAAAAAAAAAAAAAFAAAADwAAAABAAAAAAAAAAAAAAAPAAAAAQAAACMAAAAjAAAAIwAAAB4AAAAAAAAASwAAAEsAAAAAAAAASwAAAEsAAAAVAAAAYAAAAAAAAAAAAAAADwAAACADAAAAAAAAAAAAAAEAAACgMgAAVgcAAKr4//8BAAAAf39/AAEAAABkAAAAAAAAABQAAABAHwAAAAAAACYAAAAAAAAAwOD//wAAAAAmAAAAZAAAABYAAABMAAAAAAAAAAAAAAAEAAAAAAAAAAEAAABZWVkKAAAAACgAAAAoAAAAZAAAAGQAAAAAAAAAzMzMAAAAAABQAAAAUAAAAGQAAABkAAAAAAAAABcAAAAUAAAAAAAAAAAAAAD/fwAA/38AAAAAAAAJAAAABAAAAAAAAAAeAAAAaAAAAAAAAAAAAAAAAAAAAAAAAAAAAAAAECcAABAnAAAAAAAAAAAAAAAAAAAAAAAAAAAAAAAAAAAAAAAAAAAAABQAAAAAAAAAwMD/AAAAAABkAAAAMgAAAAAAAABkAAAAAAAAAH9/fwAKAAAAIgAAABgAAAAAAAAAAAAAAAAAAAAAAAAAAAAAAAAAAAAkAAAAJAAAAAAAAAAHAAAAAAAAAAAAAAAAAAAAAAAAAAAAAAAAAAAAf39/ACUAAABYAAAAAAAAAAAAAAAAAAAAAAAAAAAAAAAAAAAAAAAAAAAAAAAAAAAAAAAAAAAAAAA/AAAAAAAAAKCGAQAAAAAAAAAAAAAAAAAMAAAAAQAAAAAAAAAAAAAAAAAAAB8AAABUAAAAAAAABQAAAAEAAAAAAAAAAAAAAAAAAAAAAAAAAAAAAAAAAAAAAAAAAAAAAAB/f38AAAAAA8zMzADAwP8Af39/AAAAAAAAAAAAAAAAAAAAAAAAAAAAIQAAABgAAAAUAAAACAcAADgEAAAoIwAAUBkAABAAAAAmAAAACAAAAAEPAAAAAAAA"/>
               </a:ext>
             </a:extLst>
           </p:cNvSpPr>
@@ -743,7 +743,7 @@
             <a:spLocks noGrp="1" noChangeArrowheads="1"/>
             <a:extLst>
               <a:ext uri="smNativeData">
-                <pr:smNativeData xmlns:pr="smNativeData" xmlns="smNativeData" val="SMDATA_15_LkR5ZhMAAAAlAAAAZAAAAA0AAAAAkAAAAJAAAACQAAAAkAAAAAAAAAAAAAAAAAAAAAEAAABQAAAAAAAAAAAA4D8AAAAAAADgPwAAAAAAAOA/AAAAAAAA4D8AAAAAAADgPwAAAAAAAOA/AAAAAAAA4D8AAAAAAADgPwAAAAAAAOA/AAAAAAAA4D8CAAAAjAAAAAAAAAAAAAAAQoX0DP///wgAAAAAAAAAAAAAAAAAAAAAAAAAAAAAAAAAAAAAZAAAAAEAAABAAAAAAAAAAAAAAAAAAAAAAAAAAAAAAAAAAAAAAAAAAAAAAAAAAAAAAAAAAAAAAAAAAAAAAAAAAAAAAAAAAAAAAAAAAAAAAAAAAAAAAAAAAAAAAAAAAAAAFAAAADwAAAAAAAAAAAAAAAAAAAkUAAAAAQAAABQAAAAUAAAAFAAAAAEAAAAAAAAAZAAAAGQAAAAAAAAAZAAAAGQAAAAVAAAAYAAAAAAAAAAAAAAADwAAACADAAAAAAAAAAAAAAEAAACgMgAAVgcAAKr4//8BAAAAf39/AAEAAABkAAAAAAAAABQAAABAHwAAAAAAACYAAAAAAAAAwOD//wAAAAAmAAAAZAAAABYAAABMAAAAAAAAAAAAAAAEAAAAAAAAAAEAAABZWVkKAAAAACgAAAAoAAAAZAAAAGQAAAAAAAAAzMzMAAAAAABQAAAAUAAAAGQAAABkAAAAAAAAABcAAAAUAAAAAAAAAAAAAAD/fwAA/38AAAAAAAAJAAAABAAAAAAAAAAeAAAAaAAAAAAAAAAAAAAAAAAAAAAAAAAAAAAAECcAABAnAAAAAAAAAAAAAAAAAAAAAAAAAAAAAAAAAAAAAAAAAAAAABQAAAAAAAAAwMD/AAAAAABkAAAAMgAAAAAAAABkAAAAAAAAAH9/fwAKAAAAIgAAABgAAAAAAAAAAAAAAAAAAAAAAAAAAAAAAAAAAAAkAAAAJAAAAAAAAAAHAAAAAAAAAAAAAAAAAAAAAAAAAAAAAAAAAAAAf39/ACUAAABYAAAAAAAAAAAAAAAAAAAAAAAAAAAAAAAAAAAAAAAAAAAAAAAAAAAAAAAAAAAAAAA/AAAAAAAAAKCGAQAAAAAAAAAAAAAAAAAMAAAAAQAAAAAAAAAAAAAAAAAAAB8AAABUAAAAAAAABQAAAAEAAAAAAAAAAAAAAAAAAAAAAAAAAAAAAAAAAAAAAAAAAAAAAAJ/f38AAAAAA8zMzADAwP8Af39/AAAAAAAAAAAAAAAAAAAAAAAAAAAAIQAAABgAAAAUAAAAOAQAALgaAAD4JQAACDQAABAAAAAmAAAACAAAAL0/AAAAAAAA"/>
+                <pr:smNativeData xmlns:pr="smNativeData" xmlns="smNativeData" val="SMDATA_15_FUV5ZhMAAAAlAAAAZAAAAA0AAAAAkAAAAJAAAACQAAAAkAAAAAAAAAAAAAAAAAAAAAEAAABQAAAAAAAAAAAA4D8AAAAAAADgPwAAAAAAAOA/AAAAAAAA4D8AAAAAAADgPwAAAAAAAOA/AAAAAAAA4D8AAAAAAADgPwAAAAAAAOA/AAAAAAAA4D8CAAAAjAAAAAAAAAAAAAAAQoX0DP///wgAAAAAAAAAAAAAAAAAAAAAAAAAAAAAAAAAAAAAZAAAAAEAAABAAAAAAAAAAAAAAAAAAAAAAAAAAAAAAAAAAAAAAAAAAAAAAAAAAAAAAAAAAAAAAAAAAAAAAAAAAAAAAAAAAAAAAAAAAAAAAAAAAAAAAAAAAAAAAAAAAAAAFAAAADwAAAAAAAAAAAAAAAAAAAkUAAAAAQAAABQAAAAUAAAAFAAAAAEAAAAAAAAAZAAAAGQAAAAAAAAAZAAAAGQAAAAVAAAAYAAAAAAAAAAAAAAADwAAACADAAAAAAAAAAAAAAEAAACgMgAAVgcAAKr4//8BAAAAf39/AAEAAABkAAAAAAAAABQAAABAHwAAAAAAACYAAAAAAAAAwOD//wAAAAAmAAAAZAAAABYAAABMAAAAAAAAAAAAAAAEAAAAAAAAAAEAAABZWVkKAAAAACgAAAAoAAAAZAAAAGQAAAAAAAAAzMzMAAAAAABQAAAAUAAAAGQAAABkAAAAAAAAABcAAAAUAAAAAAAAAAAAAAD/fwAA/38AAAAAAAAJAAAABAAAAAAAAAAeAAAAaAAAAAAAAAAAAAAAAAAAAAAAAAAAAAAAECcAABAnAAAAAAAAAAAAAAAAAAAAAAAAAAAAAAAAAAAAAAAAAAAAABQAAAAAAAAAwMD/AAAAAABkAAAAMgAAAAAAAABkAAAAAAAAAH9/fwAKAAAAIgAAABgAAAAAAAAAAAAAAAAAAAAAAAAAAAAAAAAAAAAkAAAAJAAAAAAAAAAHAAAAAAAAAAAAAAAAAAAAAAAAAAAAAAAAAAAAf39/ACUAAABYAAAAAAAAAAAAAAAAAAAAAAAAAAAAAAAAAAAAAAAAAAAAAAAAAAAAAAAAAAAAAAA/AAAAAAAAAKCGAQAAAAAAAAAAAAAAAAAMAAAAAQAAAAAAAAAAAAAAAAAAAB8AAABUAAAAAAAABQAAAAEAAAAAAAAAAAAAAAAAAAAAAAAAAAAAAAAAAAAAAAAAAAAAAAJ/f38AAAAAA8zMzADAwP8Af39/AAAAAAAAAAAAAAAAAAAAAAAAAAAAIQAAABgAAAAUAAAAOAQAALgaAAD4JQAACDQAABAAAAAmAAAACAAAAL0/AAAAAAAA"/>
               </a:ext>
             </a:extLst>
           </p:cNvSpPr>
@@ -820,7 +820,7 @@
             <a:spLocks noGrp="1" noChangeArrowheads="1"/>
             <a:extLst>
               <a:ext uri="smNativeData">
-                <pr:smNativeData xmlns:pr="smNativeData" xmlns="smNativeData" val="SMDATA_15_LkR5ZhMAAAAlAAAACwAAAA0AAAAACAcAADgEAAAoIwAAUBkAAAAAAAAAAAAAAAAAAAEAAABQAAAAAAAAAAAA4D8AAAAAAADgPwAAAAAAAOA/AAAAAAAA4D8AAAAAAADgPwAAAAAAAOA/AAAAAAAA4D8AAAAAAADgPwAAAAAAAOA/AAAAAAAA4D8CAAAAjAAAAAAAAAAAAAAAQoX0DP///wgAAAAAAAAAAAAAAAAAAAAAAAAAAAAAAAAAAAAAZAAAAAEAAABAAAAAAAAAAAAAAAAAAAAAAAAAAAAAAAAAAAAAAAAAAAAAAAAAAAAAAAAAAAAAAAAAAAAAAAAAAAAAAAAAAAAAAAAAAAAAAAAAAAAAAAAAAAAAAAAAAAAAFAAAADwAAAABAAAAAAAAAAAAAAAPAAAAAQAAACMAAAAjAAAAIwAAAB4AAAAAAAAASwAAAEsAAAAAAAAASwAAAEsAAAAVAAAAYAAAAAAAAAAAAAAADwAAACADAAAAAAAAAAAAAAEAAACgMgAAVgcAAKr4//8BAAAAf39/AAEAAABkAAAAAAAAABQAAABAHwAAAAAAACYAAAAAAAAAwOD//wAAAAAmAAAAZAAAABYAAABMAAAAAAAAAAAAAAAEAAAAAAAAAAEAAABZWVkKAAAAACgAAAAoAAAAZAAAAGQAAAAAAAAAzMzMAAAAAABQAAAAUAAAAGQAAABkAAAAAAAAABcAAAAUAAAAAAAAAAAAAAD/fwAA/38AAAAAAAAJAAAABAAAALQAAAAeAAAAaAAAAAAAAAAAAAAAAAAAAAAAAAAAAAAAECcAABAnAAAAAAAAAAAAAAAAAAAAAAAAAAAAAAAAAAAAAAAAAAAAABQAAAAAAAAAwMD/AAAAAABkAAAAMgAAAAAAAABkAAAAAAAAAH9/fwAKAAAAIgAAABgAAAAAAAAAAAAAAAAAAAAAAAAAAAAAAAAAAAAkAAAAJAAAAAAAAAAHAAAAAAAAAAAAAAAAAAAAAAAAAAAAAAAAAAAAf39/ACUAAABYAAAAAAAAAAAAAAAAAAAAAAAAAAAAAAAAAAAAAAAAAAAAAAAAAAAAAAAAAAAAAAA/AAAAAAAAAKCGAQAAAAAAAAAAAAAAAAAMAAAAAQAAAAAAAAAAAAAAAAAAAB8AAABUAAAAAAAABQAAAAEAAAAAAAAAAAAAAAAAAAAAAAAAAAAAAAAAAAAAAAAAAAAAAAB/f38AAAAAA8zMzADAwP8Af39/AAAAAAAAAAAAAAAAAAAAAAAAAAAAIQAAABgAAAAUAAAACAcAADgEAAAoIwAAUBkAABAAAAAmAAAACAAAAAEPAAAAAAAA"/>
+                <pr:smNativeData xmlns:pr="smNativeData" xmlns="smNativeData" val="SMDATA_15_FUV5ZhMAAAAlAAAACwAAAA0AAAAACAcAADgEAAAoIwAAUBkAAAAAAAAAAAAAAAAAAAEAAABQAAAAAAAAAAAA4D8AAAAAAADgPwAAAAAAAOA/AAAAAAAA4D8AAAAAAADgPwAAAAAAAOA/AAAAAAAA4D8AAAAAAADgPwAAAAAAAOA/AAAAAAAA4D8CAAAAjAAAAAAAAAAAAAAAQoX0DP///wgAAAAAAAAAAAAAAAAAAAAAAAAAAAAAAAAAAAAAZAAAAAEAAABAAAAAAAAAAAAAAAAAAAAAAAAAAAAAAAAAAAAAAAAAAAAAAAAAAAAAAAAAAAAAAAAAAAAAAAAAAAAAAAAAAAAAAAAAAAAAAAAAAAAAAAAAAAAAAAAAAAAAFAAAADwAAAABAAAAAAAAAAAAAAAPAAAAAQAAACMAAAAjAAAAIwAAAB4AAAAAAAAASwAAAEsAAAAAAAAASwAAAEsAAAAVAAAAYAAAAAAAAAAAAAAADwAAACADAAAAAAAAAAAAAAEAAACgMgAAVgcAAKr4//8BAAAAf39/AAEAAABkAAAAAAAAABQAAABAHwAAAAAAACYAAAAAAAAAwOD//wAAAAAmAAAAZAAAABYAAABMAAAAAAAAAAAAAAAEAAAAAAAAAAEAAABZWVkKAAAAACgAAAAoAAAAZAAAAGQAAAAAAAAAzMzMAAAAAABQAAAAUAAAAGQAAABkAAAAAAAAABcAAAAUAAAAAAAAAAAAAAD/fwAA/38AAAAAAAAJAAAABAAAALQAAAAeAAAAaAAAAAAAAAAAAAAAAAAAAAAAAAAAAAAAECcAABAnAAAAAAAAAAAAAAAAAAAAAAAAAAAAAAAAAAAAAAAAAAAAABQAAAAAAAAAwMD/AAAAAABkAAAAMgAAAAAAAABkAAAAAAAAAH9/fwAKAAAAIgAAABgAAAAAAAAAAAAAAAAAAAAAAAAAAAAAAAAAAAAkAAAAJAAAAAAAAAAHAAAAAAAAAAAAAAAAAAAAAAAAAAAAAAAAAAAAf39/ACUAAABYAAAAAAAAAAAAAAAAAAAAAAAAAAAAAAAAAAAAAAAAAAAAAAAAAAAAAAAAAAAAAAA/AAAAAAAAAKCGAQAAAAAAAAAAAAAAAAAMAAAAAQAAAAAAAAAAAAAAAAAAAB8AAABUAAAAAAAABQAAAAEAAAAAAAAAAAAAAAAAAAAAAAAAAAAAAAAAAAAAAAAAAAAAAAB/f38AAAAAA8zMzADAwP8Af39/AAAAAAAAAAAAAAAAAAAAAAAAAAAAIQAAABgAAAAUAAAACAcAADgEAAAoIwAAUBkAABAAAAAmAAAACAAAAAEPAAAAAAAA"/>
               </a:ext>
             </a:extLst>
           </p:cNvSpPr>
@@ -866,7 +866,7 @@
             <a:spLocks noGrp="1" noChangeArrowheads="1"/>
             <a:extLst>
               <a:ext uri="smNativeData">
-                <pr:smNativeData xmlns:pr="smNativeData" xmlns="smNativeData" val="SMDATA_15_LkR5ZhMAAAAlAAAAZAAAAA0AAAAAkAAAAJAAAACQAAAAkAAAAAAAAAAAAAAAAAAAAAEAAABQAAAAAAAAAAAA4D8AAAAAAADgPwAAAAAAAOA/AAAAAAAA4D8AAAAAAADgPwAAAAAAAOA/AAAAAAAA4D8AAAAAAADgPwAAAAAAAOA/AAAAAAAA4D8CAAAAjAAAAAAAAAAAAAAAQoX0DP///wgAAAAAAAAAAAAAAAAAAAAAAAAAAAAAAAAAAAAAZAAAAAEAAABAAAAAAAAAAAAAAAAAAAAAAAAAAAAAAAAAAAAAAAAAAAAAAAAAAAAAAAAAAAAAAAAAAAAAAAAAAAAAAAAAAAAAAAAAAAAAAAAAAAAAAAAAAAAAAAAAAAAAFAAAADwAAAAAAAAAAAAAAAAAAAkUAAAAAQAAABQAAAAUAAAAFAAAAAEAAAAAAAAAZAAAAGQAAAAAAAAAZAAAAGQAAAAVAAAAYAAAAAAAAAAAAAAADwAAACADAAAAAAAAAAAAAAEAAACgMgAAVgcAAKr4//8BAAAAf39/AAEAAABkAAAAAAAAABQAAABAHwAAAAAAACYAAAAAAAAAwOD//wAAAAAmAAAAZAAAABYAAABMAAAAAAAAAAAAAAAEAAAAAAAAAAEAAABZWVkKAAAAACgAAAAoAAAAZAAAAGQAAAAAAAAAzMzMAAAAAABQAAAAUAAAAGQAAABkAAAAAAAAABcAAAAUAAAAAAAAAAAAAAD/fwAA/38AAAAAAAAJAAAABAAAAIK8UsUeAAAAaAAAAAAAAAAAAAAAAAAAAAAAAAAAAAAAECcAABAnAAAAAAAAAAAAAAAAAAAAAAAAAAAAAAAAAAAAAAAAAAAAABQAAAAAAAAAwMD/AAAAAABkAAAAMgAAAAAAAABkAAAAAAAAAH9/fwAKAAAAIgAAABgAAAAAAAAAAAAAAAAAAAAAAAAAAAAAAAAAAAAkAAAAJAAAAAAAAAAHAAAAAAAAAAAAAAAAAAAAAAAAAAAAAAAAAAAAf39/ACUAAABYAAAAAAAAAAAAAAAAAAAAAAAAAAAAAAAAAAAAAAAAAAAAAAAAAAAAAAAAAAAAAAA/AAAAAAAAAKCGAQAAAAAAAAAAAAAAAAAMAAAAAQAAAAAAAAAAAAAAAAAAAB8AAABUAAAAAAAABQAAAAEAAAAAAAAAAAAAAAAAAAAAAAAAAAAAAAAAAAAAAAAAAAAAAAJ/f38AAAAAA8zMzADAwP8Af39/AAAAAAAAAAAAAAAAAAAAAAAAAAAAIQAAABgAAAAUAAAAOAQAALgaAAD4JQAACDQAABAAAAAmAAAACAAAAL0/AAAAAAAA"/>
+                <pr:smNativeData xmlns:pr="smNativeData" xmlns="smNativeData" val="SMDATA_15_FUV5ZhMAAAAlAAAAZAAAAA0AAAAAkAAAAJAAAACQAAAAkAAAAAAAAAAAAAAAAAAAAAEAAABQAAAAAAAAAAAA4D8AAAAAAADgPwAAAAAAAOA/AAAAAAAA4D8AAAAAAADgPwAAAAAAAOA/AAAAAAAA4D8AAAAAAADgPwAAAAAAAOA/AAAAAAAA4D8CAAAAjAAAAAAAAAAAAAAAQoX0DP///wgAAAAAAAAAAAAAAAAAAAAAAAAAAAAAAAAAAAAAZAAAAAEAAABAAAAAAAAAAAAAAAAAAAAAAAAAAAAAAAAAAAAAAAAAAAAAAAAAAAAAAAAAAAAAAAAAAAAAAAAAAAAAAAAAAAAAAAAAAAAAAAAAAAAAAAAAAAAAAAAAAAAAFAAAADwAAAAAAAAAAAAAAAAAAAkUAAAAAQAAABQAAAAUAAAAFAAAAAEAAAAAAAAAZAAAAGQAAAAAAAAAZAAAAGQAAAAVAAAAYAAAAAAAAAAAAAAADwAAACADAAAAAAAAAAAAAAEAAACgMgAAVgcAAKr4//8BAAAAf39/AAEAAABkAAAAAAAAABQAAABAHwAAAAAAACYAAAAAAAAAwOD//wAAAAAmAAAAZAAAABYAAABMAAAAAAAAAAAAAAAEAAAAAAAAAAEAAABZWVkKAAAAACgAAAAoAAAAZAAAAGQAAAAAAAAAzMzMAAAAAABQAAAAUAAAAGQAAABkAAAAAAAAABcAAAAUAAAAAAAAAAAAAAD/fwAA/38AAAAAAAAJAAAABAAAAIK8UsUeAAAAaAAAAAAAAAAAAAAAAAAAAAAAAAAAAAAAECcAABAnAAAAAAAAAAAAAAAAAAAAAAAAAAAAAAAAAAAAAAAAAAAAABQAAAAAAAAAwMD/AAAAAABkAAAAMgAAAAAAAABkAAAAAAAAAH9/fwAKAAAAIgAAABgAAAAAAAAAAAAAAAAAAAAAAAAAAAAAAAAAAAAkAAAAJAAAAAAAAAAHAAAAAAAAAAAAAAAAAAAAAAAAAAAAAAAAAAAAf39/ACUAAABYAAAAAAAAAAAAAAAAAAAAAAAAAAAAAAAAAAAAAAAAAAAAAAAAAAAAAAAAAAAAAAA/AAAAAAAAAKCGAQAAAAAAAAAAAAAAAAAMAAAAAQAAAAAAAAAAAAAAAAAAAB8AAABUAAAAAAAABQAAAAEAAAAAAAAAAAAAAAAAAAAAAAAAAAAAAAAAAAAAAAAAAAAAAAJ/f38AAAAAA8zMzADAwP8Af39/AAAAAAAAAAAAAAAAAAAAAAAAAAAAIQAAABgAAAAUAAAAOAQAALgaAAD4JQAACDQAABAAAAAmAAAACAAAAL0/AAAAAAAA"/>
               </a:ext>
             </a:extLst>
           </p:cNvSpPr>
@@ -943,7 +943,7 @@
             <a:spLocks noGrp="1" noChangeArrowheads="1"/>
             <a:extLst>
               <a:ext uri="smNativeData">
-                <pr:smNativeData xmlns:pr="smNativeData" xmlns="smNativeData" val="SMDATA_15_LkR5ZhMAAAAlAAAACwAAAA0AAAAACAcAADgEAAAoIwAAUBkAAAAAAAAAAAAAAAAAAAEAAABQAAAAAAAAAAAA4D8AAAAAAADgPwAAAAAAAOA/AAAAAAAA4D8AAAAAAADgPwAAAAAAAOA/AAAAAAAA4D8AAAAAAADgPwAAAAAAAOA/AAAAAAAA4D8CAAAAjAAAAAAAAAAAAAAAQoX0DP///wgAAAAAAAAAAAAAAAAAAAAAAAAAAAAAAAAAAAAAZAAAAAEAAABAAAAAAAAAAAAAAAAAAAAAAAAAAAAAAAAAAAAAAAAAAAAAAAAAAAAAAAAAAAAAAAAAAAAAAAAAAAAAAAAAAAAAAAAAAAAAAAAAAAAAAAAAAAAAAAAAAAAAFAAAADwAAAABAAAAAAAAAAAAAAAPAAAAAQAAACMAAAAjAAAAIwAAAB4AAAAAAAAASwAAAEsAAAAAAAAASwAAAEsAAAAVAAAAYAAAAAAAAAAAAAAADwAAACADAAAAAAAAAAAAAAEAAACgMgAAVgcAAKr4//8BAAAAf39/AAEAAABkAAAAAAAAABQAAABAHwAAAAAAACYAAAAAAAAAwOD//wAAAAAmAAAAZAAAABYAAABMAAAAAAAAAAAAAAAEAAAAAAAAAAEAAABZWVkKAAAAACgAAAAoAAAAZAAAAGQAAAAAAAAAzMzMAAAAAABQAAAAUAAAAGQAAABkAAAAAAAAABcAAAAUAAAAAAAAAAAAAAD/fwAA/38AAAAAAAAJAAAABAAAAAAAAAAeAAAAaAAAAAAAAAAAAAAAAAAAAAAAAAAAAAAAECcAABAnAAAAAAAAAAAAAAAAAAAAAAAAAAAAAAAAAAAAAAAAAAAAABQAAAAAAAAAwMD/AAAAAABkAAAAMgAAAAAAAABkAAAAAAAAAH9/fwAKAAAAIgAAABgAAAAAAAAAAAAAAAAAAAAAAAAAAAAAAAAAAAAkAAAAJAAAAAAAAAAHAAAAAAAAAAAAAAAAAAAAAAAAAAAAAAAAAAAAf39/ACUAAABYAAAAAAAAAAAAAAAAAAAAAAAAAAAAAAAAAAAAAAAAAAAAAAAAAAAAAAAAAAAAAAA/AAAAAAAAAKCGAQAAAAAAAAAAAAAAAAAMAAAAAQAAAAAAAAAAAAAAAAAAAB8AAABUAAAAAAAABQAAAAEAAAAAAAAAAAAAAAAAAAAAAAAAAAAAAAAAAAAAAAAAAAAAAAB/f38AAAAAA8zMzADAwP8Af39/AAAAAAAAAAAAAAAAAAAAAAAAAAAAIQAAABgAAAAUAAAACAcAADgEAAAoIwAAUBkAABAAAAAmAAAACAAAAAEPAAAAAAAA"/>
+                <pr:smNativeData xmlns:pr="smNativeData" xmlns="smNativeData" val="SMDATA_15_FUV5ZhMAAAAlAAAACwAAAA0AAAAACAcAADgEAAAoIwAAUBkAAAAAAAAAAAAAAAAAAAEAAABQAAAAAAAAAAAA4D8AAAAAAADgPwAAAAAAAOA/AAAAAAAA4D8AAAAAAADgPwAAAAAAAOA/AAAAAAAA4D8AAAAAAADgPwAAAAAAAOA/AAAAAAAA4D8CAAAAjAAAAAAAAAAAAAAAQoX0DP///wgAAAAAAAAAAAAAAAAAAAAAAAAAAAAAAAAAAAAAZAAAAAEAAABAAAAAAAAAAAAAAAAAAAAAAAAAAAAAAAAAAAAAAAAAAAAAAAAAAAAAAAAAAAAAAAAAAAAAAAAAAAAAAAAAAAAAAAAAAAAAAAAAAAAAAAAAAAAAAAAAAAAAFAAAADwAAAABAAAAAAAAAAAAAAAPAAAAAQAAACMAAAAjAAAAIwAAAB4AAAAAAAAASwAAAEsAAAAAAAAASwAAAEsAAAAVAAAAYAAAAAAAAAAAAAAADwAAACADAAAAAAAAAAAAAAEAAACgMgAAVgcAAKr4//8BAAAAf39/AAEAAABkAAAAAAAAABQAAABAHwAAAAAAACYAAAAAAAAAwOD//wAAAAAmAAAAZAAAABYAAABMAAAAAAAAAAAAAAAEAAAAAAAAAAEAAABZWVkKAAAAACgAAAAoAAAAZAAAAGQAAAAAAAAAzMzMAAAAAABQAAAAUAAAAGQAAABkAAAAAAAAABcAAAAUAAAAAAAAAAAAAAD/fwAA/38AAAAAAAAJAAAABAAAAAAAAAAeAAAAaAAAAAAAAAAAAAAAAAAAAAAAAAAAAAAAECcAABAnAAAAAAAAAAAAAAAAAAAAAAAAAAAAAAAAAAAAAAAAAAAAABQAAAAAAAAAwMD/AAAAAABkAAAAMgAAAAAAAABkAAAAAAAAAH9/fwAKAAAAIgAAABgAAAAAAAAAAAAAAAAAAAAAAAAAAAAAAAAAAAAkAAAAJAAAAAAAAAAHAAAAAAAAAAAAAAAAAAAAAAAAAAAAAAAAAAAAf39/ACUAAABYAAAAAAAAAAAAAAAAAAAAAAAAAAAAAAAAAAAAAAAAAAAAAAAAAAAAAAAAAAAAAAA/AAAAAAAAAKCGAQAAAAAAAAAAAAAAAAAMAAAAAQAAAAAAAAAAAAAAAAAAAB8AAABUAAAAAAAABQAAAAEAAAAAAAAAAAAAAAAAAAAAAAAAAAAAAAAAAAAAAAAAAAAAAAB/f38AAAAAA8zMzADAwP8Af39/AAAAAAAAAAAAAAAAAAAAAAAAAAAAIQAAABgAAAAUAAAACAcAADgEAAAoIwAAUBkAABAAAAAmAAAACAAAAAEPAAAAAAAA"/>
               </a:ext>
             </a:extLst>
           </p:cNvSpPr>
@@ -989,7 +989,7 @@
             <a:spLocks noGrp="1" noChangeArrowheads="1"/>
             <a:extLst>
               <a:ext uri="smNativeData">
-                <pr:smNativeData xmlns:pr="smNativeData" xmlns="smNativeData" val="SMDATA_15_LkR5ZhMAAAAlAAAAZAAAAA0AAAAAkAAAAJAAAACQAAAAkAAAAAAAAAAAAAAAAAAAAAEAAABQAAAAAAAAAAAA4D8AAAAAAADgPwAAAAAAAOA/AAAAAAAA4D8AAAAAAADgPwAAAAAAAOA/AAAAAAAA4D8AAAAAAADgPwAAAAAAAOA/AAAAAAAA4D8CAAAAjAAAAAAAAAAAAAAAQoX0DP///wgAAAAAAAAAAAAAAAAAAAAAAAAAAAAAAAAAAAAAZAAAAAEAAABAAAAAAAAAAAAAAAAAAAAAAAAAAAAAAAAAAAAAAAAAAAAAAAAAAAAAAAAAAAAAAAAAAAAAAAAAAAAAAAAAAAAAAAAAAAAAAAAAAAAAAAAAAAAAAAAAAAAAFAAAADwAAAAAAAAAAAAAAAAAAAkUAAAAAQAAABQAAAAUAAAAFAAAAAEAAAAAAAAAZAAAAGQAAAAAAAAAZAAAAGQAAAAVAAAAYAAAAAAAAAAAAAAADwAAACADAAAAAAAAAAAAAAEAAACgMgAAVgcAAKr4//8BAAAAf39/AAEAAABkAAAAAAAAABQAAABAHwAAAAAAACYAAAAAAAAAwOD//wAAAAAmAAAAZAAAABYAAABMAAAAAAAAAAAAAAAEAAAAAAAAAAEAAABZWVkKAAAAACgAAAAoAAAAZAAAAGQAAAAAAAAAzMzMAAAAAABQAAAAUAAAAGQAAABkAAAAAAAAABcAAAAUAAAAAAAAAAAAAAD/fwAA/38AAAAAAAAJAAAABAAAAMGa1cUeAAAAaAAAAAAAAAAAAAAAAAAAAAAAAAAAAAAAECcAABAnAAAAAAAAAAAAAAAAAAAAAAAAAAAAAAAAAAAAAAAAAAAAABQAAAAAAAAAwMD/AAAAAABkAAAAMgAAAAAAAABkAAAAAAAAAH9/fwAKAAAAIgAAABgAAAAAAAAAAAAAAAAAAAAAAAAAAAAAAAAAAAAkAAAAJAAAAAAAAAAHAAAAAAAAAAAAAAAAAAAAAAAAAAAAAAAAAAAAf39/ACUAAABYAAAAAAAAAAAAAAAAAAAAAAAAAAAAAAAAAAAAAAAAAAAAAAAAAAAAAAAAAAAAAAA/AAAAAAAAAKCGAQAAAAAAAAAAAAAAAAAMAAAAAQAAAAAAAAAAAAAAAAAAAB8AAABUAAAAAAAABQAAAAEAAAAAAAAAAAAAAAAAAAAAAAAAAAAAAAAAAAAAAAAAAAAAAAJ/f38AAAAAA8zMzADAwP8Af39/AAAAAAAAAAAAAAAAAAAAAAAAAAAAIQAAABgAAAAUAAAAOAQAALgaAAD4JQAACDQAABAAAAAmAAAACAAAAL0/AAAAAAAA"/>
+                <pr:smNativeData xmlns:pr="smNativeData" xmlns="smNativeData" val="SMDATA_15_FUV5ZhMAAAAlAAAAZAAAAA0AAAAAkAAAAJAAAACQAAAAkAAAAAAAAAAAAAAAAAAAAAEAAABQAAAAAAAAAAAA4D8AAAAAAADgPwAAAAAAAOA/AAAAAAAA4D8AAAAAAADgPwAAAAAAAOA/AAAAAAAA4D8AAAAAAADgPwAAAAAAAOA/AAAAAAAA4D8CAAAAjAAAAAAAAAAAAAAAQoX0DP///wgAAAAAAAAAAAAAAAAAAAAAAAAAAAAAAAAAAAAAZAAAAAEAAABAAAAAAAAAAAAAAAAAAAAAAAAAAAAAAAAAAAAAAAAAAAAAAAAAAAAAAAAAAAAAAAAAAAAAAAAAAAAAAAAAAAAAAAAAAAAAAAAAAAAAAAAAAAAAAAAAAAAAFAAAADwAAAAAAAAAAAAAAAAAAAkUAAAAAQAAABQAAAAUAAAAFAAAAAEAAAAAAAAAZAAAAGQAAAAAAAAAZAAAAGQAAAAVAAAAYAAAAAAAAAAAAAAADwAAACADAAAAAAAAAAAAAAEAAACgMgAAVgcAAKr4//8BAAAAf39/AAEAAABkAAAAAAAAABQAAABAHwAAAAAAACYAAAAAAAAAwOD//wAAAAAmAAAAZAAAABYAAABMAAAAAAAAAAAAAAAEAAAAAAAAAAEAAABZWVkKAAAAACgAAAAoAAAAZAAAAGQAAAAAAAAAzMzMAAAAAABQAAAAUAAAAGQAAABkAAAAAAAAABcAAAAUAAAAAAAAAAAAAAD/fwAA/38AAAAAAAAJAAAABAAAAMGa1cUeAAAAaAAAAAAAAAAAAAAAAAAAAAAAAAAAAAAAECcAABAnAAAAAAAAAAAAAAAAAAAAAAAAAAAAAAAAAAAAAAAAAAAAABQAAAAAAAAAwMD/AAAAAABkAAAAMgAAAAAAAABkAAAAAAAAAH9/fwAKAAAAIgAAABgAAAAAAAAAAAAAAAAAAAAAAAAAAAAAAAAAAAAkAAAAJAAAAAAAAAAHAAAAAAAAAAAAAAAAAAAAAAAAAAAAAAAAAAAAf39/ACUAAABYAAAAAAAAAAAAAAAAAAAAAAAAAAAAAAAAAAAAAAAAAAAAAAAAAAAAAAAAAAAAAAA/AAAAAAAAAKCGAQAAAAAAAAAAAAAAAAAMAAAAAQAAAAAAAAAAAAAAAAAAAB8AAABUAAAAAAAABQAAAAEAAAAAAAAAAAAAAAAAAAAAAAAAAAAAAAAAAAAAAAAAAAAAAAJ/f38AAAAAA8zMzADAwP8Af39/AAAAAAAAAAAAAAAAAAAAAAAAAAAAIQAAABgAAAAUAAAAOAQAALgaAAD4JQAACDQAABAAAAAmAAAACAAAAL0/AAAAAAAA"/>
               </a:ext>
             </a:extLst>
           </p:cNvSpPr>
@@ -1066,7 +1066,7 @@
             <a:spLocks noGrp="1" noChangeArrowheads="1"/>
             <a:extLst>
               <a:ext uri="smNativeData">
-                <pr:smNativeData xmlns:pr="smNativeData" xmlns="smNativeData" val="SMDATA_15_LkR5ZhMAAAAlAAAACwAAAA0AAAAACAcAADgEAAAoIwAAUBkAAAAAAAAAAAAAAAAAAAEAAABQAAAAAAAAAAAA4D8AAAAAAADgPwAAAAAAAOA/AAAAAAAA4D8AAAAAAADgPwAAAAAAAOA/AAAAAAAA4D8AAAAAAADgPwAAAAAAAOA/AAAAAAAA4D8CAAAAjAAAAAAAAAAAAAAAQoX0DP///wgAAAAAAAAAAAAAAAAAAAAAAAAAAAAAAAAAAAAAZAAAAAEAAABAAAAAAAAAAAAAAAAAAAAAAAAAAAAAAAAAAAAAAAAAAAAAAAAAAAAAAAAAAAAAAAAAAAAAAAAAAAAAAAAAAAAAAAAAAAAAAAAAAAAAAAAAAAAAAAAAAAAAFAAAADwAAAABAAAAAAAAAAAAAAAPAAAAAQAAACMAAAAjAAAAIwAAAB4AAAAAAAAASwAAAEsAAAAAAAAASwAAAEsAAAAVAAAAYAAAAAAAAAAAAAAADwAAACADAAAAAAAAAAAAAAEAAACgMgAAVgcAAKr4//8BAAAAf39/AAEAAABkAAAAAAAAABQAAABAHwAAAAAAACYAAAAAAAAAwOD//wAAAAAmAAAAZAAAABYAAABMAAAAAAAAAAAAAAAEAAAAAAAAAAEAAABZWVkKAAAAACgAAAAoAAAAZAAAAGQAAAAAAAAAzMzMAAAAAABQAAAAUAAAAGQAAABkAAAAAAAAABcAAAAUAAAAAAAAAAAAAAD/fwAA/38AAAAAAAAJAAAABAAAAAAAAAAeAAAAaAAAAAAAAAAAAAAAAAAAAAAAAAAAAAAAECcAABAnAAAAAAAAAAAAAAAAAAAAAAAAAAAAAAAAAAAAAAAAAAAAABQAAAAAAAAAwMD/AAAAAABkAAAAMgAAAAAAAABkAAAAAAAAAH9/fwAKAAAAIgAAABgAAAAAAAAAAAAAAAAAAAAAAAAAAAAAAAAAAAAkAAAAJAAAAAAAAAAHAAAAAAAAAAAAAAAAAAAAAAAAAAAAAAAAAAAAf39/ACUAAABYAAAAAAAAAAAAAAAAAAAAAAAAAAAAAAAAAAAAAAAAAAAAAAAAAAAAAAAAAAAAAAA/AAAAAAAAAKCGAQAAAAAAAAAAAAAAAAAMAAAAAQAAAAAAAAAAAAAAAAAAAB8AAABUAAAAAAAABQAAAAEAAAAAAAAAAAAAAAAAAAAAAAAAAAAAAAAAAAAAAAAAAAAAAAB/f38AAAAAA8zMzADAwP8Af39/AAAAAAAAAAAAAAAAAAAAAAAAAAAAIQAAABgAAAAUAAAACAcAADgEAAAoIwAAUBkAABAAAAAmAAAACAAAAAEPAAAAAAAA"/>
+                <pr:smNativeData xmlns:pr="smNativeData" xmlns="smNativeData" val="SMDATA_15_FUV5ZhMAAAAlAAAACwAAAA0AAAAACAcAADgEAAAoIwAAUBkAAAAAAAAAAAAAAAAAAAEAAABQAAAAAAAAAAAA4D8AAAAAAADgPwAAAAAAAOA/AAAAAAAA4D8AAAAAAADgPwAAAAAAAOA/AAAAAAAA4D8AAAAAAADgPwAAAAAAAOA/AAAAAAAA4D8CAAAAjAAAAAAAAAAAAAAAQoX0DP///wgAAAAAAAAAAAAAAAAAAAAAAAAAAAAAAAAAAAAAZAAAAAEAAABAAAAAAAAAAAAAAAAAAAAAAAAAAAAAAAAAAAAAAAAAAAAAAAAAAAAAAAAAAAAAAAAAAAAAAAAAAAAAAAAAAAAAAAAAAAAAAAAAAAAAAAAAAAAAAAAAAAAAFAAAADwAAAABAAAAAAAAAAAAAAAPAAAAAQAAACMAAAAjAAAAIwAAAB4AAAAAAAAASwAAAEsAAAAAAAAASwAAAEsAAAAVAAAAYAAAAAAAAAAAAAAADwAAACADAAAAAAAAAAAAAAEAAACgMgAAVgcAAKr4//8BAAAAf39/AAEAAABkAAAAAAAAABQAAABAHwAAAAAAACYAAAAAAAAAwOD//wAAAAAmAAAAZAAAABYAAABMAAAAAAAAAAAAAAAEAAAAAAAAAAEAAABZWVkKAAAAACgAAAAoAAAAZAAAAGQAAAAAAAAAzMzMAAAAAABQAAAAUAAAAGQAAABkAAAAAAAAABcAAAAUAAAAAAAAAAAAAAD/fwAA/38AAAAAAAAJAAAABAAAAAAAAAAeAAAAaAAAAAAAAAAAAAAAAAAAAAAAAAAAAAAAECcAABAnAAAAAAAAAAAAAAAAAAAAAAAAAAAAAAAAAAAAAAAAAAAAABQAAAAAAAAAwMD/AAAAAABkAAAAMgAAAAAAAABkAAAAAAAAAH9/fwAKAAAAIgAAABgAAAAAAAAAAAAAAAAAAAAAAAAAAAAAAAAAAAAkAAAAJAAAAAAAAAAHAAAAAAAAAAAAAAAAAAAAAAAAAAAAAAAAAAAAf39/ACUAAABYAAAAAAAAAAAAAAAAAAAAAAAAAAAAAAAAAAAAAAAAAAAAAAAAAAAAAAAAAAAAAAA/AAAAAAAAAKCGAQAAAAAAAAAAAAAAAAAMAAAAAQAAAAAAAAAAAAAAAAAAAB8AAABUAAAAAAAABQAAAAEAAAAAAAAAAAAAAAAAAAAAAAAAAAAAAAAAAAAAAAAAAAAAAAB/f38AAAAAA8zMzADAwP8Af39/AAAAAAAAAAAAAAAAAAAAAAAAAAAAIQAAABgAAAAUAAAACAcAADgEAAAoIwAAUBkAABAAAAAmAAAACAAAAAEPAAAAAAAA"/>
               </a:ext>
             </a:extLst>
           </p:cNvSpPr>
@@ -1112,7 +1112,7 @@
             <a:spLocks noGrp="1" noChangeArrowheads="1"/>
             <a:extLst>
               <a:ext uri="smNativeData">
-                <pr:smNativeData xmlns:pr="smNativeData" xmlns="smNativeData" val="SMDATA_15_LkR5ZhMAAAAlAAAAZAAAAA0AAAAAkAAAAJAAAACQAAAAkAAAAAAAAAAAAAAAAAAAAAEAAABQAAAAAAAAAAAA4D8AAAAAAADgPwAAAAAAAOA/AAAAAAAA4D8AAAAAAADgPwAAAAAAAOA/AAAAAAAA4D8AAAAAAADgPwAAAAAAAOA/AAAAAAAA4D8CAAAAjAAAAAAAAAAAAAAAQoX0DP///wgAAAAAAAAAAAAAAAAAAAAAAAAAAAAAAAAAAAAAZAAAAAEAAABAAAAAAAAAAAAAAAAAAAAAAAAAAAAAAAAAAAAAAAAAAAAAAAAAAAAAAAAAAAAAAAAAAAAAAAAAAAAAAAAAAAAAAAAAAAAAAAAAAAAAAAAAAAAAAAAAAAAAFAAAADwAAAAAAAAAAAAAAAAAAAkUAAAAAQAAABQAAAAUAAAAFAAAAAEAAAAAAAAAZAAAAGQAAAAAAAAAZAAAAGQAAAAVAAAAYAAAAAAAAAAAAAAADwAAACADAAAAAAAAAAAAAAEAAACgMgAAVgcAAKr4//8BAAAAf39/AAEAAABkAAAAAAAAABQAAABAHwAAAAAAACYAAAAAAAAAwOD//wAAAAAmAAAAZAAAABYAAABMAAAAAAAAAAAAAAAEAAAAAAAAAAEAAABZWVkKAAAAACgAAAAoAAAAZAAAAGQAAAAAAAAAzMzMAAAAAABQAAAAUAAAAGQAAABkAAAAAAAAABcAAAAUAAAAAAAAAAAAAAD/fwAA/38AAAAAAAAJAAAABAAAAF8AYAAeAAAAaAAAAAAAAAAAAAAAAAAAAAAAAAAAAAAAECcAABAnAAAAAAAAAAAAAAAAAAAAAAAAAAAAAAAAAAAAAAAAAAAAABQAAAAAAAAAwMD/AAAAAABkAAAAMgAAAAAAAABkAAAAAAAAAH9/fwAKAAAAIgAAABgAAAAAAAAAAAAAAAAAAAAAAAAAAAAAAAAAAAAkAAAAJAAAAAAAAAAHAAAAAAAAAAAAAAAAAAAAAAAAAAAAAAAAAAAAf39/ACUAAABYAAAAAAAAAAAAAAAAAAAAAAAAAAAAAAAAAAAAAAAAAAAAAAAAAAAAAAAAAAAAAAA/AAAAAAAAAKCGAQAAAAAAAAAAAAAAAAAMAAAAAQAAAAAAAAAAAAAAAAAAAB8AAABUAAAAAAAABQAAAAEAAAAAAAAAAAAAAAAAAAAAAAAAAAAAAAAAAAAAAAAAAAAAAAJ/f38AAAAAA8zMzADAwP8Af39/AAAAAAAAAAAAAAAAAAAAAAAAAAAAIQAAABgAAAAUAAAAOAQAALgaAAD4JQAACDQAABAAAAAmAAAACAAAAL0/AAAAAAAA"/>
+                <pr:smNativeData xmlns:pr="smNativeData" xmlns="smNativeData" val="SMDATA_15_FUV5ZhMAAAAlAAAAZAAAAA0AAAAAkAAAAJAAAACQAAAAkAAAAAAAAAAAAAAAAAAAAAEAAABQAAAAAAAAAAAA4D8AAAAAAADgPwAAAAAAAOA/AAAAAAAA4D8AAAAAAADgPwAAAAAAAOA/AAAAAAAA4D8AAAAAAADgPwAAAAAAAOA/AAAAAAAA4D8CAAAAjAAAAAAAAAAAAAAAQoX0DP///wgAAAAAAAAAAAAAAAAAAAAAAAAAAAAAAAAAAAAAZAAAAAEAAABAAAAAAAAAAAAAAAAAAAAAAAAAAAAAAAAAAAAAAAAAAAAAAAAAAAAAAAAAAAAAAAAAAAAAAAAAAAAAAAAAAAAAAAAAAAAAAAAAAAAAAAAAAAAAAAAAAAAAFAAAADwAAAAAAAAAAAAAAAAAAAkUAAAAAQAAABQAAAAUAAAAFAAAAAEAAAAAAAAAZAAAAGQAAAAAAAAAZAAAAGQAAAAVAAAAYAAAAAAAAAAAAAAADwAAACADAAAAAAAAAAAAAAEAAACgMgAAVgcAAKr4//8BAAAAf39/AAEAAABkAAAAAAAAABQAAABAHwAAAAAAACYAAAAAAAAAwOD//wAAAAAmAAAAZAAAABYAAABMAAAAAAAAAAAAAAAEAAAAAAAAAAEAAABZWVkKAAAAACgAAAAoAAAAZAAAAGQAAAAAAAAAzMzMAAAAAABQAAAAUAAAAGQAAABkAAAAAAAAABcAAAAUAAAAAAAAAAAAAAD/fwAA/38AAAAAAAAJAAAABAAAAF8AYAAeAAAAaAAAAAAAAAAAAAAAAAAAAAAAAAAAAAAAECcAABAnAAAAAAAAAAAAAAAAAAAAAAAAAAAAAAAAAAAAAAAAAAAAABQAAAAAAAAAwMD/AAAAAABkAAAAMgAAAAAAAABkAAAAAAAAAH9/fwAKAAAAIgAAABgAAAAAAAAAAAAAAAAAAAAAAAAAAAAAAAAAAAAkAAAAJAAAAAAAAAAHAAAAAAAAAAAAAAAAAAAAAAAAAAAAAAAAAAAAf39/ACUAAABYAAAAAAAAAAAAAAAAAAAAAAAAAAAAAAAAAAAAAAAAAAAAAAAAAAAAAAAAAAAAAAA/AAAAAAAAAKCGAQAAAAAAAAAAAAAAAAAMAAAAAQAAAAAAAAAAAAAAAAAAAB8AAABUAAAAAAAABQAAAAEAAAAAAAAAAAAAAAAAAAAAAAAAAAAAAAAAAAAAAAAAAAAAAAJ/f38AAAAAA8zMzADAwP8Af39/AAAAAAAAAAAAAAAAAAAAAAAAAAAAIQAAABgAAAAUAAAAOAQAALgaAAD4JQAACDQAABAAAAAmAAAACAAAAL0/AAAAAAAA"/>
               </a:ext>
             </a:extLst>
           </p:cNvSpPr>
@@ -1189,7 +1189,7 @@
             <a:spLocks noGrp="1" noChangeArrowheads="1"/>
             <a:extLst>
               <a:ext uri="smNativeData">
-                <pr:smNativeData xmlns:pr="smNativeData" xmlns="smNativeData" val="SMDATA_15_LkR5ZhMAAAAlAAAACwAAAA0AAAAACAcAADgEAAAoIwAAUBkAAAAAAAAAAAAAAAAAAAEAAABQAAAAAAAAAAAA4D8AAAAAAADgPwAAAAAAAOA/AAAAAAAA4D8AAAAAAADgPwAAAAAAAOA/AAAAAAAA4D8AAAAAAADgPwAAAAAAAOA/AAAAAAAA4D8CAAAAjAAAAAAAAAAAAAAAQoX0DP///wgAAAAAAAAAAAAAAAAAAAAAAAAAAAAAAAAAAAAAZAAAAAEAAABAAAAAAAAAAAAAAAAAAAAAAAAAAAAAAAAAAAAAAAAAAAAAAAAAAAAAAAAAAAAAAAAAAAAAAAAAAAAAAAAAAAAAAAAAAAAAAAAAAAAAAAAAAAAAAAAAAAAAFAAAADwAAAABAAAAAAAAAAAAAAAPAAAAAQAAACMAAAAjAAAAIwAAAB4AAAAAAAAASwAAAEsAAAAAAAAASwAAAEsAAAAVAAAAYAAAAAAAAAAAAAAADwAAACADAAAAAAAAAAAAAAEAAACgMgAAVgcAAKr4//8BAAAAf39/AAEAAABkAAAAAAAAABQAAABAHwAAAAAAACYAAAAAAAAAwOD//wAAAAAmAAAAZAAAABYAAABMAAAAAAAAAAAAAAAEAAAAAAAAAAEAAABZWVkKAAAAACgAAAAoAAAAZAAAAGQAAAAAAAAAzMzMAAAAAABQAAAAUAAAAGQAAABkAAAAAAAAABcAAAAUAAAAAAAAAAAAAAD/fwAA/38AAAAAAAAJAAAABAAAAAAAAAAeAAAAaAAAAAAAAAAAAAAAAAAAAAAAAAAAAAAAECcAABAnAAAAAAAAAAAAAAAAAAAAAAAAAAAAAAAAAAAAAAAAAAAAABQAAAAAAAAAwMD/AAAAAABkAAAAMgAAAAAAAABkAAAAAAAAAH9/fwAKAAAAIgAAABgAAAAAAAAAAAAAAAAAAAAAAAAAAAAAAAAAAAAkAAAAJAAAAAAAAAAHAAAAAAAAAAAAAAAAAAAAAAAAAAAAAAAAAAAAf39/ACUAAABYAAAAAAAAAAAAAAAAAAAAAAAAAAAAAAAAAAAAAAAAAAAAAAAAAAAAAAAAAAAAAAA/AAAAAAAAAKCGAQAAAAAAAAAAAAAAAAAMAAAAAQAAAAAAAAAAAAAAAAAAAB8AAABUAAAAAAAABQAAAAEAAAAAAAAAAAAAAAAAAAAAAAAAAAAAAAAAAAAAAAAAAAAAAAB/f38AAAAAA8zMzADAwP8Af39/AAAAAAAAAAAAAAAAAAAAAAAAAAAAIQAAABgAAAAUAAAACAcAADgEAAAoIwAAUBkAABAAAAAmAAAACAAAAAEPAAAAAAAA"/>
+                <pr:smNativeData xmlns:pr="smNativeData" xmlns="smNativeData" val="SMDATA_15_FUV5ZhMAAAAlAAAACwAAAA0AAAAACAcAADgEAAAoIwAAUBkAAAAAAAAAAAAAAAAAAAEAAABQAAAAAAAAAAAA4D8AAAAAAADgPwAAAAAAAOA/AAAAAAAA4D8AAAAAAADgPwAAAAAAAOA/AAAAAAAA4D8AAAAAAADgPwAAAAAAAOA/AAAAAAAA4D8CAAAAjAAAAAAAAAAAAAAAQoX0DP///wgAAAAAAAAAAAAAAAAAAAAAAAAAAAAAAAAAAAAAZAAAAAEAAABAAAAAAAAAAAAAAAAAAAAAAAAAAAAAAAAAAAAAAAAAAAAAAAAAAAAAAAAAAAAAAAAAAAAAAAAAAAAAAAAAAAAAAAAAAAAAAAAAAAAAAAAAAAAAAAAAAAAAFAAAADwAAAABAAAAAAAAAAAAAAAPAAAAAQAAACMAAAAjAAAAIwAAAB4AAAAAAAAASwAAAEsAAAAAAAAASwAAAEsAAAAVAAAAYAAAAAAAAAAAAAAADwAAACADAAAAAAAAAAAAAAEAAACgMgAAVgcAAKr4//8BAAAAf39/AAEAAABkAAAAAAAAABQAAABAHwAAAAAAACYAAAAAAAAAwOD//wAAAAAmAAAAZAAAABYAAABMAAAAAAAAAAAAAAAEAAAAAAAAAAEAAABZWVkKAAAAACgAAAAoAAAAZAAAAGQAAAAAAAAAzMzMAAAAAABQAAAAUAAAAGQAAABkAAAAAAAAABcAAAAUAAAAAAAAAAAAAAD/fwAA/38AAAAAAAAJAAAABAAAAAAAAAAeAAAAaAAAAAAAAAAAAAAAAAAAAAAAAAAAAAAAECcAABAnAAAAAAAAAAAAAAAAAAAAAAAAAAAAAAAAAAAAAAAAAAAAABQAAAAAAAAAwMD/AAAAAABkAAAAMgAAAAAAAABkAAAAAAAAAH9/fwAKAAAAIgAAABgAAAAAAAAAAAAAAAAAAAAAAAAAAAAAAAAAAAAkAAAAJAAAAAAAAAAHAAAAAAAAAAAAAAAAAAAAAAAAAAAAAAAAAAAAf39/ACUAAABYAAAAAAAAAAAAAAAAAAAAAAAAAAAAAAAAAAAAAAAAAAAAAAAAAAAAAAAAAAAAAAA/AAAAAAAAAKCGAQAAAAAAAAAAAAAAAAAMAAAAAQAAAAAAAAAAAAAAAAAAAB8AAABUAAAAAAAABQAAAAEAAAAAAAAAAAAAAAAAAAAAAAAAAAAAAAAAAAAAAAAAAAAAAAB/f38AAAAAA8zMzADAwP8Af39/AAAAAAAAAAAAAAAAAAAAAAAAAAAAIQAAABgAAAAUAAAACAcAADgEAAAoIwAAUBkAABAAAAAmAAAACAAAAAEPAAAAAAAA"/>
               </a:ext>
             </a:extLst>
           </p:cNvSpPr>
@@ -1235,7 +1235,7 @@
             <a:spLocks noGrp="1" noChangeArrowheads="1"/>
             <a:extLst>
               <a:ext uri="smNativeData">
-                <pr:smNativeData xmlns:pr="smNativeData" xmlns="smNativeData" val="SMDATA_15_LkR5ZhMAAAAlAAAAZAAAAA0AAAAAkAAAAJAAAACQAAAAkAAAAAAAAAAAAAAAAAAAAAEAAABQAAAAAAAAAAAA4D8AAAAAAADgPwAAAAAAAOA/AAAAAAAA4D8AAAAAAADgPwAAAAAAAOA/AAAAAAAA4D8AAAAAAADgPwAAAAAAAOA/AAAAAAAA4D8CAAAAjAAAAAAAAAAAAAAAQoX0DP///wgAAAAAAAAAAAAAAAAAAAAAAAAAAAAAAAAAAAAAZAAAAAEAAABAAAAAAAAAAAAAAAAAAAAAAAAAAAAAAAAAAAAAAAAAAAAAAAAAAAAAAAAAAAAAAAAAAAAAAAAAAAAAAAAAAAAAAAAAAAAAAAAAAAAAAAAAAAAAAAAAAAAAFAAAADwAAAAAAAAAAAAAAAAAAAkUAAAAAQAAABQAAAAUAAAAFAAAAAEAAAAAAAAAZAAAAGQAAAAAAAAAZAAAAGQAAAAVAAAAYAAAAAAAAAAAAAAADwAAACADAAAAAAAAAAAAAAEAAACgMgAAVgcAAKr4//8BAAAAf39/AAEAAABkAAAAAAAAABQAAABAHwAAAAAAACYAAAAAAAAAwOD//wAAAAAmAAAAZAAAABYAAABMAAAAAAAAAAAAAAAEAAAAAAAAAAEAAABZWVkKAAAAACgAAAAoAAAAZAAAAGQAAAAAAAAAzMzMAAAAAABQAAAAUAAAAGQAAABkAAAAAAAAABcAAAAUAAAAAAAAAAAAAAD/fwAA/38AAAAAAAAJAAAABAAAAM/Y+1ceAAAAaAAAAAAAAAAAAAAAAAAAAAAAAAAAAAAAECcAABAnAAAAAAAAAAAAAAAAAAAAAAAAAAAAAAAAAAAAAAAAAAAAABQAAAAAAAAAwMD/AAAAAABkAAAAMgAAAAAAAABkAAAAAAAAAH9/fwAKAAAAIgAAABgAAAAAAAAAAAAAAAAAAAAAAAAAAAAAAAAAAAAkAAAAJAAAAAAAAAAHAAAAAAAAAAAAAAAAAAAAAAAAAAAAAAAAAAAAf39/ACUAAABYAAAAAAAAAAAAAAAAAAAAAAAAAAAAAAAAAAAAAAAAAAAAAAAAAAAAAAAAAAAAAAA/AAAAAAAAAKCGAQAAAAAAAAAAAAAAAAAMAAAAAQAAAAAAAAAAAAAAAAAAAB8AAABUAAAAAAAABQAAAAEAAAAAAAAAAAAAAAAAAAAAAAAAAAAAAAAAAAAAAAAAAAAAAAJ/f38AAAAAA8zMzADAwP8Af39/AAAAAAAAAAAAAAAAAAAAAAAAAAAAIQAAABgAAAAUAAAAOAQAALgaAAD4JQAACDQAABAAAAAmAAAACAAAAL0/AAAAAAAA"/>
+                <pr:smNativeData xmlns:pr="smNativeData" xmlns="smNativeData" val="SMDATA_15_FUV5ZhMAAAAlAAAAZAAAAA0AAAAAkAAAAJAAAACQAAAAkAAAAAAAAAAAAAAAAAAAAAEAAABQAAAAAAAAAAAA4D8AAAAAAADgPwAAAAAAAOA/AAAAAAAA4D8AAAAAAADgPwAAAAAAAOA/AAAAAAAA4D8AAAAAAADgPwAAAAAAAOA/AAAAAAAA4D8CAAAAjAAAAAAAAAAAAAAAQoX0DP///wgAAAAAAAAAAAAAAAAAAAAAAAAAAAAAAAAAAAAAZAAAAAEAAABAAAAAAAAAAAAAAAAAAAAAAAAAAAAAAAAAAAAAAAAAAAAAAAAAAAAAAAAAAAAAAAAAAAAAAAAAAAAAAAAAAAAAAAAAAAAAAAAAAAAAAAAAAAAAAAAAAAAAFAAAADwAAAAAAAAAAAAAAAAAAAkUAAAAAQAAABQAAAAUAAAAFAAAAAEAAAAAAAAAZAAAAGQAAAAAAAAAZAAAAGQAAAAVAAAAYAAAAAAAAAAAAAAADwAAACADAAAAAAAAAAAAAAEAAACgMgAAVgcAAKr4//8BAAAAf39/AAEAAABkAAAAAAAAABQAAABAHwAAAAAAACYAAAAAAAAAwOD//wAAAAAmAAAAZAAAABYAAABMAAAAAAAAAAAAAAAEAAAAAAAAAAEAAABZWVkKAAAAACgAAAAoAAAAZAAAAGQAAAAAAAAAzMzMAAAAAABQAAAAUAAAAGQAAABkAAAAAAAAABcAAAAUAAAAAAAAAAAAAAD/fwAA/38AAAAAAAAJAAAABAAAAM/Y+1ceAAAAaAAAAAAAAAAAAAAAAAAAAAAAAAAAAAAAECcAABAnAAAAAAAAAAAAAAAAAAAAAAAAAAAAAAAAAAAAAAAAAAAAABQAAAAAAAAAwMD/AAAAAABkAAAAMgAAAAAAAABkAAAAAAAAAH9/fwAKAAAAIgAAABgAAAAAAAAAAAAAAAAAAAAAAAAAAAAAAAAAAAAkAAAAJAAAAAAAAAAHAAAAAAAAAAAAAAAAAAAAAAAAAAAAAAAAAAAAf39/ACUAAABYAAAAAAAAAAAAAAAAAAAAAAAAAAAAAAAAAAAAAAAAAAAAAAAAAAAAAAAAAAAAAAA/AAAAAAAAAKCGAQAAAAAAAAAAAAAAAAAMAAAAAQAAAAAAAAAAAAAAAAAAAB8AAABUAAAAAAAABQAAAAEAAAAAAAAAAAAAAAAAAAAAAAAAAAAAAAAAAAAAAAAAAAAAAAJ/f38AAAAAA8zMzADAwP8Af39/AAAAAAAAAAAAAAAAAAAAAAAAAAAAIQAAABgAAAAUAAAAOAQAALgaAAD4JQAACDQAABAAAAAmAAAACAAAAL0/AAAAAAAA"/>
               </a:ext>
             </a:extLst>
           </p:cNvSpPr>
@@ -1312,7 +1312,7 @@
             <a:spLocks noGrp="1" noChangeArrowheads="1"/>
             <a:extLst>
               <a:ext uri="smNativeData">
-                <pr:smNativeData xmlns:pr="smNativeData" xmlns="smNativeData" val="SMDATA_15_LkR5ZhMAAAAlAAAACwAAAA0AAAAACAcAADgEAAAoIwAAUBkAAAAAAAAAAAAAAAAAAAEAAABQAAAAAAAAAAAA4D8AAAAAAADgPwAAAAAAAOA/AAAAAAAA4D8AAAAAAADgPwAAAAAAAOA/AAAAAAAA4D8AAAAAAADgPwAAAAAAAOA/AAAAAAAA4D8CAAAAjAAAAAAAAAAAAAAAQoX0DP///wgAAAAAAAAAAAAAAAAAAAAAAAAAAAAAAAAAAAAAZAAAAAEAAABAAAAAAAAAAAAAAAAAAAAAAAAAAAAAAAAAAAAAAAAAAAAAAAAAAAAAAAAAAAAAAAAAAAAAAAAAAAAAAAAAAAAAAAAAAAAAAAAAAAAAAAAAAAAAAAAAAAAAFAAAADwAAAABAAAAAAAAAAAAAAAPAAAAAQAAACMAAAAjAAAAIwAAAB4AAAAAAAAASwAAAEsAAAAAAAAASwAAAEsAAAAVAAAAYAAAAAAAAAAAAAAADwAAACADAAAAAAAAAAAAAAEAAACgMgAAVgcAAKr4//8BAAAAf39/AAEAAABkAAAAAAAAABQAAABAHwAAAAAAACYAAAAAAAAAwOD//wAAAAAmAAAAZAAAABYAAABMAAAAAAAAAAAAAAAEAAAAAAAAAAEAAABZWVkKAAAAACgAAAAoAAAAZAAAAGQAAAAAAAAAzMzMAAAAAABQAAAAUAAAAGQAAABkAAAAAAAAABcAAAAUAAAAAAAAAAAAAAD/fwAA/38AAAAAAAAJAAAABAAAAEXJ0L8eAAAAaAAAAAAAAAAAAAAAAAAAAAAAAAAAAAAAECcAABAnAAAAAAAAAAAAAAAAAAAAAAAAAAAAAAAAAAAAAAAAAAAAABQAAAAAAAAAwMD/AAAAAABkAAAAMgAAAAAAAABkAAAAAAAAAH9/fwAKAAAAIgAAABgAAAAAAAAAAAAAAAAAAAAAAAAAAAAAAAAAAAAkAAAAJAAAAAAAAAAHAAAAAAAAAAAAAAAAAAAAAAAAAAAAAAAAAAAAf39/ACUAAABYAAAAAAAAAAAAAAAAAAAAAAAAAAAAAAAAAAAAAAAAAAAAAAAAAAAAAAAAAAAAAAA/AAAAAAAAAKCGAQAAAAAAAAAAAAAAAAAMAAAAAQAAAAAAAAAAAAAAAAAAAB8AAABUAAAAAAAABQAAAAEAAAAAAAAAAAAAAAAAAAAAAAAAAAAAAAAAAAAAAAAAAAAAAAB/f38AAAAAA8zMzADAwP8Af39/AAAAAAAAAAAAAAAAAAAAAAAAAAAAIQAAABgAAAAUAAAACAcAADgEAAAoIwAAUBkAABAAAAAmAAAACAAAAAEPAAAAAAAA"/>
+                <pr:smNativeData xmlns:pr="smNativeData" xmlns="smNativeData" val="SMDATA_15_FUV5ZhMAAAAlAAAACwAAAA0AAAAACAcAADgEAAAoIwAAUBkAAAAAAAAAAAAAAAAAAAEAAABQAAAAAAAAAAAA4D8AAAAAAADgPwAAAAAAAOA/AAAAAAAA4D8AAAAAAADgPwAAAAAAAOA/AAAAAAAA4D8AAAAAAADgPwAAAAAAAOA/AAAAAAAA4D8CAAAAjAAAAAAAAAAAAAAAQoX0DP///wgAAAAAAAAAAAAAAAAAAAAAAAAAAAAAAAAAAAAAZAAAAAEAAABAAAAAAAAAAAAAAAAAAAAAAAAAAAAAAAAAAAAAAAAAAAAAAAAAAAAAAAAAAAAAAAAAAAAAAAAAAAAAAAAAAAAAAAAAAAAAAAAAAAAAAAAAAAAAAAAAAAAAFAAAADwAAAABAAAAAAAAAAAAAAAPAAAAAQAAACMAAAAjAAAAIwAAAB4AAAAAAAAASwAAAEsAAAAAAAAASwAAAEsAAAAVAAAAYAAAAAAAAAAAAAAADwAAACADAAAAAAAAAAAAAAEAAACgMgAAVgcAAKr4//8BAAAAf39/AAEAAABkAAAAAAAAABQAAABAHwAAAAAAACYAAAAAAAAAwOD//wAAAAAmAAAAZAAAABYAAABMAAAAAAAAAAAAAAAEAAAAAAAAAAEAAABZWVkKAAAAACgAAAAoAAAAZAAAAGQAAAAAAAAAzMzMAAAAAABQAAAAUAAAAGQAAABkAAAAAAAAABcAAAAUAAAAAAAAAAAAAAD/fwAA/38AAAAAAAAJAAAABAAAAEXJ0L8eAAAAaAAAAAAAAAAAAAAAAAAAAAAAAAAAAAAAECcAABAnAAAAAAAAAAAAAAAAAAAAAAAAAAAAAAAAAAAAAAAAAAAAABQAAAAAAAAAwMD/AAAAAABkAAAAMgAAAAAAAABkAAAAAAAAAH9/fwAKAAAAIgAAABgAAAAAAAAAAAAAAAAAAAAAAAAAAAAAAAAAAAAkAAAAJAAAAAAAAAAHAAAAAAAAAAAAAAAAAAAAAAAAAAAAAAAAAAAAf39/ACUAAABYAAAAAAAAAAAAAAAAAAAAAAAAAAAAAAAAAAAAAAAAAAAAAAAAAAAAAAAAAAAAAAA/AAAAAAAAAKCGAQAAAAAAAAAAAAAAAAAMAAAAAQAAAAAAAAAAAAAAAAAAAB8AAABUAAAAAAAABQAAAAEAAAAAAAAAAAAAAAAAAAAAAAAAAAAAAAAAAAAAAAAAAAAAAAB/f38AAAAAA8zMzADAwP8Af39/AAAAAAAAAAAAAAAAAAAAAAAAAAAAIQAAABgAAAAUAAAACAcAADgEAAAoIwAAUBkAABAAAAAmAAAACAAAAAEPAAAAAAAA"/>
               </a:ext>
             </a:extLst>
           </p:cNvSpPr>
@@ -1358,7 +1358,7 @@
             <a:spLocks noGrp="1" noChangeArrowheads="1"/>
             <a:extLst>
               <a:ext uri="smNativeData">
-                <pr:smNativeData xmlns:pr="smNativeData" xmlns="smNativeData" val="SMDATA_15_LkR5ZhMAAAAlAAAAZAAAAA0AAAAAkAAAAJAAAACQAAAAkAAAAAAAAAAAAAAAAAAAAAEAAABQAAAAAAAAAAAA4D8AAAAAAADgPwAAAAAAAOA/AAAAAAAA4D8AAAAAAADgPwAAAAAAAOA/AAAAAAAA4D8AAAAAAADgPwAAAAAAAOA/AAAAAAAA4D8CAAAAjAAAAAAAAAAAAAAAQoX0DP///wgAAAAAAAAAAAAAAAAAAAAAAAAAAAAAAAAAAAAAZAAAAAEAAABAAAAAAAAAAAAAAAAAAAAAAAAAAAAAAAAAAAAAAAAAAAAAAAAAAAAAAAAAAAAAAAAAAAAAAAAAAAAAAAAAAAAAAAAAAAAAAAAAAAAAAAAAAAAAAAAAAAAAFAAAADwAAAAAAAAAAAAAAAAAAAkUAAAAAQAAABQAAAAUAAAAFAAAAAEAAAAAAAAAZAAAAGQAAAAAAAAAZAAAAGQAAAAVAAAAYAAAAAAAAAAAAAAADwAAACADAAAAAAAAAAAAAAEAAACgMgAAVgcAAKr4//8BAAAAf39/AAEAAABkAAAAAAAAABQAAABAHwAAAAAAACYAAAAAAAAAwOD//wAAAAAmAAAAZAAAABYAAABMAAAAAAAAAAAAAAAEAAAAAAAAAAEAAABZWVkKAAAAACgAAAAoAAAAZAAAAGQAAAAAAAAAzMzMAAAAAABQAAAAUAAAAGQAAABkAAAAAAAAABcAAAAUAAAAAAAAAAAAAAD/fwAA/38AAAAAAAAJAAAABAAAAF8AYAAeAAAAaAAAAAAAAAAAAAAAAAAAAAAAAAAAAAAAECcAABAnAAAAAAAAAAAAAAAAAAAAAAAAAAAAAAAAAAAAAAAAAAAAABQAAAAAAAAAwMD/AAAAAABkAAAAMgAAAAAAAABkAAAAAAAAAH9/fwAKAAAAIgAAABgAAAAAAAAAAAAAAAAAAAAAAAAAAAAAAAAAAAAkAAAAJAAAAAAAAAAHAAAAAAAAAAAAAAAAAAAAAAAAAAAAAAAAAAAAf39/ACUAAABYAAAAAAAAAAAAAAAAAAAAAAAAAAAAAAAAAAAAAAAAAAAAAAAAAAAAAAAAAAAAAAA/AAAAAAAAAKCGAQAAAAAAAAAAAAAAAAAMAAAAAQAAAAAAAAAAAAAAAAAAAB8AAABUAAAAAAAABQAAAAEAAAAAAAAAAAAAAAAAAAAAAAAAAAAAAAAAAAAAAAAAAAAAAAJ/f38AAAAAA8zMzADAwP8Af39/AAAAAAAAAAAAAAAAAAAAAAAAAAAAIQAAABgAAAAUAAAAOAQAALgaAAD4JQAACDQAABAAAAAmAAAACAAAAL0/AAAAAAAA"/>
+                <pr:smNativeData xmlns:pr="smNativeData" xmlns="smNativeData" val="SMDATA_15_FUV5ZhMAAAAlAAAAZAAAAA0AAAAAkAAAAJAAAACQAAAAkAAAAAAAAAAAAAAAAAAAAAEAAABQAAAAAAAAAAAA4D8AAAAAAADgPwAAAAAAAOA/AAAAAAAA4D8AAAAAAADgPwAAAAAAAOA/AAAAAAAA4D8AAAAAAADgPwAAAAAAAOA/AAAAAAAA4D8CAAAAjAAAAAAAAAAAAAAAQoX0DP///wgAAAAAAAAAAAAAAAAAAAAAAAAAAAAAAAAAAAAAZAAAAAEAAABAAAAAAAAAAAAAAAAAAAAAAAAAAAAAAAAAAAAAAAAAAAAAAAAAAAAAAAAAAAAAAAAAAAAAAAAAAAAAAAAAAAAAAAAAAAAAAAAAAAAAAAAAAAAAAAAAAAAAFAAAADwAAAAAAAAAAAAAAAAAAAkUAAAAAQAAABQAAAAUAAAAFAAAAAEAAAAAAAAAZAAAAGQAAAAAAAAAZAAAAGQAAAAVAAAAYAAAAAAAAAAAAAAADwAAACADAAAAAAAAAAAAAAEAAACgMgAAVgcAAKr4//8BAAAAf39/AAEAAABkAAAAAAAAABQAAABAHwAAAAAAACYAAAAAAAAAwOD//wAAAAAmAAAAZAAAABYAAABMAAAAAAAAAAAAAAAEAAAAAAAAAAEAAABZWVkKAAAAACgAAAAoAAAAZAAAAGQAAAAAAAAAzMzMAAAAAABQAAAAUAAAAGQAAABkAAAAAAAAABcAAAAUAAAAAAAAAAAAAAD/fwAA/38AAAAAAAAJAAAABAAAAF8AYAAeAAAAaAAAAAAAAAAAAAAAAAAAAAAAAAAAAAAAECcAABAnAAAAAAAAAAAAAAAAAAAAAAAAAAAAAAAAAAAAAAAAAAAAABQAAAAAAAAAwMD/AAAAAABkAAAAMgAAAAAAAABkAAAAAAAAAH9/fwAKAAAAIgAAABgAAAAAAAAAAAAAAAAAAAAAAAAAAAAAAAAAAAAkAAAAJAAAAAAAAAAHAAAAAAAAAAAAAAAAAAAAAAAAAAAAAAAAAAAAf39/ACUAAABYAAAAAAAAAAAAAAAAAAAAAAAAAAAAAAAAAAAAAAAAAAAAAAAAAAAAAAAAAAAAAAA/AAAAAAAAAKCGAQAAAAAAAAAAAAAAAAAMAAAAAQAAAAAAAAAAAAAAAAAAAB8AAABUAAAAAAAABQAAAAEAAAAAAAAAAAAAAAAAAAAAAAAAAAAAAAAAAAAAAAAAAAAAAAJ/f38AAAAAA8zMzADAwP8Af39/AAAAAAAAAAAAAAAAAAAAAAAAAAAAIQAAABgAAAAUAAAAOAQAALgaAAD4JQAACDQAABAAAAAmAAAACAAAAL0/AAAAAAAA"/>
               </a:ext>
             </a:extLst>
           </p:cNvSpPr>
@@ -1435,7 +1435,7 @@
             <a:spLocks noGrp="1" noChangeArrowheads="1"/>
             <a:extLst>
               <a:ext uri="smNativeData">
-                <pr:smNativeData xmlns:pr="smNativeData" xmlns="smNativeData" val="SMDATA_15_LkR5ZhMAAAAlAAAACwAAAA0AAAAACAcAADgEAAAoIwAAUBkAAAAAAAAAAAAAAAAAAAEAAABQAAAAAAAAAAAA4D8AAAAAAADgPwAAAAAAAOA/AAAAAAAA4D8AAAAAAADgPwAAAAAAAOA/AAAAAAAA4D8AAAAAAADgPwAAAAAAAOA/AAAAAAAA4D8CAAAAjAAAAAAAAAAAAAAAQoX0DP///wgAAAAAAAAAAAAAAAAAAAAAAAAAAAAAAAAAAAAAZAAAAAEAAABAAAAAAAAAAAAAAAAAAAAAAAAAAAAAAAAAAAAAAAAAAAAAAAAAAAAAAAAAAAAAAAAAAAAAAAAAAAAAAAAAAAAAAAAAAAAAAAAAAAAAAAAAAAAAAAAAAAAAFAAAADwAAAABAAAAAAAAAAAAAAAPAAAAAQAAACMAAAAjAAAAIwAAAB4AAAAAAAAASwAAAEsAAAAAAAAASwAAAEsAAAAVAAAAYAAAAAAAAAAAAAAADwAAACADAAAAAAAAAAAAAAEAAACgMgAAVgcAAKr4//8BAAAAf39/AAEAAABkAAAAAAAAABQAAABAHwAAAAAAACYAAAAAAAAAwOD//wAAAAAmAAAAZAAAABYAAABMAAAAAAAAAAAAAAAEAAAAAAAAAAEAAABZWVkKAAAAACgAAAAoAAAAZAAAAGQAAAAAAAAAzMzMAAAAAABQAAAAUAAAAGQAAABkAAAAAAAAABcAAAAUAAAAAAAAAAAAAAD/fwAA/38AAAAAAAAJAAAABAAAAAAAAAAeAAAAaAAAAAAAAAAAAAAAAAAAAAAAAAAAAAAAECcAABAnAAAAAAAAAAAAAAAAAAAAAAAAAAAAAAAAAAAAAAAAAAAAABQAAAAAAAAAwMD/AAAAAABkAAAAMgAAAAAAAABkAAAAAAAAAH9/fwAKAAAAIgAAABgAAAAAAAAAAAAAAAAAAAAAAAAAAAAAAAAAAAAkAAAAJAAAAAAAAAAHAAAAAAAAAAAAAAAAAAAAAAAAAAAAAAAAAAAAf39/ACUAAABYAAAAAAAAAAAAAAAAAAAAAAAAAAAAAAAAAAAAAAAAAAAAAAAAAAAAAAAAAAAAAAA/AAAAAAAAAKCGAQAAAAAAAAAAAAAAAAAMAAAAAQAAAAAAAAAAAAAAAAAAAB8AAABUAAAAAAAABQAAAAEAAAAAAAAAAAAAAAAAAAAAAAAAAAAAAAAAAAAAAAAAAAAAAAB/f38AAAAAA8zMzADAwP8Af39/AAAAAAAAAAAAAAAAAAAAAAAAAAAAIQAAABgAAAAUAAAACAcAADgEAAAoIwAAUBkAABAAAAAmAAAACAAAAAEPAAAAAAAA"/>
+                <pr:smNativeData xmlns:pr="smNativeData" xmlns="smNativeData" val="SMDATA_15_FUV5ZhMAAAAlAAAACwAAAA0AAAAACAcAADgEAAAoIwAAUBkAAAAAAAAAAAAAAAAAAAEAAABQAAAAAAAAAAAA4D8AAAAAAADgPwAAAAAAAOA/AAAAAAAA4D8AAAAAAADgPwAAAAAAAOA/AAAAAAAA4D8AAAAAAADgPwAAAAAAAOA/AAAAAAAA4D8CAAAAjAAAAAAAAAAAAAAAQoX0DP///wgAAAAAAAAAAAAAAAAAAAAAAAAAAAAAAAAAAAAAZAAAAAEAAABAAAAAAAAAAAAAAAAAAAAAAAAAAAAAAAAAAAAAAAAAAAAAAAAAAAAAAAAAAAAAAAAAAAAAAAAAAAAAAAAAAAAAAAAAAAAAAAAAAAAAAAAAAAAAAAAAAAAAFAAAADwAAAABAAAAAAAAAAAAAAAPAAAAAQAAACMAAAAjAAAAIwAAAB4AAAAAAAAASwAAAEsAAAAAAAAASwAAAEsAAAAVAAAAYAAAAAAAAAAAAAAADwAAACADAAAAAAAAAAAAAAEAAACgMgAAVgcAAKr4//8BAAAAf39/AAEAAABkAAAAAAAAABQAAABAHwAAAAAAACYAAAAAAAAAwOD//wAAAAAmAAAAZAAAABYAAABMAAAAAAAAAAAAAAAEAAAAAAAAAAEAAABZWVkKAAAAACgAAAAoAAAAZAAAAGQAAAAAAAAAzMzMAAAAAABQAAAAUAAAAGQAAABkAAAAAAAAABcAAAAUAAAAAAAAAAAAAAD/fwAA/38AAAAAAAAJAAAABAAAAAAAAAAeAAAAaAAAAAAAAAAAAAAAAAAAAAAAAAAAAAAAECcAABAnAAAAAAAAAAAAAAAAAAAAAAAAAAAAAAAAAAAAAAAAAAAAABQAAAAAAAAAwMD/AAAAAABkAAAAMgAAAAAAAABkAAAAAAAAAH9/fwAKAAAAIgAAABgAAAAAAAAAAAAAAAAAAAAAAAAAAAAAAAAAAAAkAAAAJAAAAAAAAAAHAAAAAAAAAAAAAAAAAAAAAAAAAAAAAAAAAAAAf39/ACUAAABYAAAAAAAAAAAAAAAAAAAAAAAAAAAAAAAAAAAAAAAAAAAAAAAAAAAAAAAAAAAAAAA/AAAAAAAAAKCGAQAAAAAAAAAAAAAAAAAMAAAAAQAAAAAAAAAAAAAAAAAAAB8AAABUAAAAAAAABQAAAAEAAAAAAAAAAAAAAAAAAAAAAAAAAAAAAAAAAAAAAAAAAAAAAAB/f38AAAAAA8zMzADAwP8Af39/AAAAAAAAAAAAAAAAAAAAAAAAAAAAIQAAABgAAAAUAAAACAcAADgEAAAoIwAAUBkAABAAAAAmAAAACAAAAAEPAAAAAAAA"/>
               </a:ext>
             </a:extLst>
           </p:cNvSpPr>
@@ -1481,7 +1481,7 @@
             <a:spLocks noGrp="1" noChangeArrowheads="1"/>
             <a:extLst>
               <a:ext uri="smNativeData">
-                <pr:smNativeData xmlns:pr="smNativeData" xmlns="smNativeData" val="SMDATA_15_LkR5ZhMAAAAlAAAAZAAAAA0AAAAAkAAAAJAAAACQAAAAkAAAAAAAAAAAAAAAAAAAAAEAAABQAAAAAAAAAAAA4D8AAAAAAADgPwAAAAAAAOA/AAAAAAAA4D8AAAAAAADgPwAAAAAAAOA/AAAAAAAA4D8AAAAAAADgPwAAAAAAAOA/AAAAAAAA4D8CAAAAjAAAAAAAAAAAAAAAQoX0DP///wgAAAAAAAAAAAAAAAAAAAAAAAAAAAAAAAAAAAAAZAAAAAEAAABAAAAAAAAAAAAAAAAAAAAAAAAAAAAAAAAAAAAAAAAAAAAAAAAAAAAAAAAAAAAAAAAAAAAAAAAAAAAAAAAAAAAAAAAAAAAAAAAAAAAAAAAAAAAAAAAAAAAAFAAAADwAAAAAAAAAAAAAAAAAAAkUAAAAAQAAABQAAAAUAAAAFAAAAAEAAAAAAAAAZAAAAGQAAAAAAAAAZAAAAGQAAAAVAAAAYAAAAAAAAAAAAAAADwAAACADAAAAAAAAAAAAAAEAAACgMgAAVgcAAKr4//8BAAAAf39/AAEAAABkAAAAAAAAABQAAABAHwAAAAAAACYAAAAAAAAAwOD//wAAAAAmAAAAZAAAABYAAABMAAAAAAAAAAAAAAAEAAAAAAAAAAEAAABZWVkKAAAAACgAAAAoAAAAZAAAAGQAAAAAAAAAzMzMAAAAAABQAAAAUAAAAGQAAABkAAAAAAAAABcAAAAUAAAAAAAAAAAAAAD/fwAA/38AAAAAAAAJAAAABAAAADFRIqYeAAAAaAAAAAAAAAAAAAAAAAAAAAAAAAAAAAAAECcAABAnAAAAAAAAAAAAAAAAAAAAAAAAAAAAAAAAAAAAAAAAAAAAABQAAAAAAAAAwMD/AAAAAABkAAAAMgAAAAAAAABkAAAAAAAAAH9/fwAKAAAAIgAAABgAAAAAAAAAAAAAAAAAAAAAAAAAAAAAAAAAAAAkAAAAJAAAAAAAAAAHAAAAAAAAAAAAAAAAAAAAAAAAAAAAAAAAAAAAf39/ACUAAABYAAAAAAAAAAAAAAAAAAAAAAAAAAAAAAAAAAAAAAAAAAAAAAAAAAAAAAAAAAAAAAA/AAAAAAAAAKCGAQAAAAAAAAAAAAAAAAAMAAAAAQAAAAAAAAAAAAAAAAAAAB8AAABUAAAAAAAABQAAAAEAAAAAAAAAAAAAAAAAAAAAAAAAAAAAAAAAAAAAAAAAAAAAAAJ/f38AAAAAA8zMzADAwP8Af39/AAAAAAAAAAAAAAAAAAAAAAAAAAAAIQAAABgAAAAUAAAAOAQAALgaAAD4JQAACDQAABAAAAAmAAAACAAAAL0/AAAAAAAA"/>
+                <pr:smNativeData xmlns:pr="smNativeData" xmlns="smNativeData" val="SMDATA_15_FUV5ZhMAAAAlAAAAZAAAAA0AAAAAkAAAAJAAAACQAAAAkAAAAAAAAAAAAAAAAAAAAAEAAABQAAAAAAAAAAAA4D8AAAAAAADgPwAAAAAAAOA/AAAAAAAA4D8AAAAAAADgPwAAAAAAAOA/AAAAAAAA4D8AAAAAAADgPwAAAAAAAOA/AAAAAAAA4D8CAAAAjAAAAAAAAAAAAAAAQoX0DP///wgAAAAAAAAAAAAAAAAAAAAAAAAAAAAAAAAAAAAAZAAAAAEAAABAAAAAAAAAAAAAAAAAAAAAAAAAAAAAAAAAAAAAAAAAAAAAAAAAAAAAAAAAAAAAAAAAAAAAAAAAAAAAAAAAAAAAAAAAAAAAAAAAAAAAAAAAAAAAAAAAAAAAFAAAADwAAAAAAAAAAAAAAAAAAAkUAAAAAQAAABQAAAAUAAAAFAAAAAEAAAAAAAAAZAAAAGQAAAAAAAAAZAAAAGQAAAAVAAAAYAAAAAAAAAAAAAAADwAAACADAAAAAAAAAAAAAAEAAACgMgAAVgcAAKr4//8BAAAAf39/AAEAAABkAAAAAAAAABQAAABAHwAAAAAAACYAAAAAAAAAwOD//wAAAAAmAAAAZAAAABYAAABMAAAAAAAAAAAAAAAEAAAAAAAAAAEAAABZWVkKAAAAACgAAAAoAAAAZAAAAGQAAAAAAAAAzMzMAAAAAABQAAAAUAAAAGQAAABkAAAAAAAAABcAAAAUAAAAAAAAAAAAAAD/fwAA/38AAAAAAAAJAAAABAAAADFRIqYeAAAAaAAAAAAAAAAAAAAAAAAAAAAAAAAAAAAAECcAABAnAAAAAAAAAAAAAAAAAAAAAAAAAAAAAAAAAAAAAAAAAAAAABQAAAAAAAAAwMD/AAAAAABkAAAAMgAAAAAAAABkAAAAAAAAAH9/fwAKAAAAIgAAABgAAAAAAAAAAAAAAAAAAAAAAAAAAAAAAAAAAAAkAAAAJAAAAAAAAAAHAAAAAAAAAAAAAAAAAAAAAAAAAAAAAAAAAAAAf39/ACUAAABYAAAAAAAAAAAAAAAAAAAAAAAAAAAAAAAAAAAAAAAAAAAAAAAAAAAAAAAAAAAAAAA/AAAAAAAAAKCGAQAAAAAAAAAAAAAAAAAMAAAAAQAAAAAAAAAAAAAAAAAAAB8AAABUAAAAAAAABQAAAAEAAAAAAAAAAAAAAAAAAAAAAAAAAAAAAAAAAAAAAAAAAAAAAAJ/f38AAAAAA8zMzADAwP8Af39/AAAAAAAAAAAAAAAAAAAAAAAAAAAAIQAAABgAAAAUAAAAOAQAALgaAAD4JQAACDQAABAAAAAmAAAACAAAAL0/AAAAAAAA"/>
               </a:ext>
             </a:extLst>
           </p:cNvSpPr>
@@ -1558,7 +1558,7 @@
             <a:spLocks noGrp="1" noChangeArrowheads="1"/>
             <a:extLst>
               <a:ext uri="smNativeData">
-                <pr:smNativeData xmlns:pr="smNativeData" xmlns="smNativeData" val="SMDATA_15_LkR5ZhMAAAAlAAAACwAAAA0AAAAACAcAADgEAAAoIwAAUBkAAAAAAAAAAAAAAAAAAAEAAABQAAAAAAAAAAAA4D8AAAAAAADgPwAAAAAAAOA/AAAAAAAA4D8AAAAAAADgPwAAAAAAAOA/AAAAAAAA4D8AAAAAAADgPwAAAAAAAOA/AAAAAAAA4D8CAAAAjAAAAAAAAAAAAAAAQoX0DP///wgAAAAAAAAAAAAAAAAAAAAAAAAAAAAAAAAAAAAAZAAAAAEAAABAAAAAAAAAAAAAAAAAAAAAAAAAAAAAAAAAAAAAAAAAAAAAAAAAAAAAAAAAAAAAAAAAAAAAAAAAAAAAAAAAAAAAAAAAAAAAAAAAAAAAAAAAAAAAAAAAAAAAFAAAADwAAAABAAAAAAAAAAAAAAAPAAAAAQAAACMAAAAjAAAAIwAAAB4AAAAAAAAASwAAAEsAAAAAAAAASwAAAEsAAAAVAAAAYAAAAAAAAAAAAAAADwAAACADAAAAAAAAAAAAAAEAAACgMgAAVgcAAKr4//8BAAAAf39/AAEAAABkAAAAAAAAABQAAABAHwAAAAAAACYAAAAAAAAAwOD//wAAAAAmAAAAZAAAABYAAABMAAAAAAAAAAAAAAAEAAAAAAAAAAEAAABZWVkKAAAAACgAAAAoAAAAZAAAAGQAAAAAAAAAzMzMAAAAAABQAAAAUAAAAGQAAABkAAAAAAAAABcAAAAUAAAAAAAAAAAAAAD/fwAA/38AAAAAAAAJAAAABAAAAAAAAAAeAAAAaAAAAAAAAAAAAAAAAAAAAAAAAAAAAAAAECcAABAnAAAAAAAAAAAAAAAAAAAAAAAAAAAAAAAAAAAAAAAAAAAAABQAAAAAAAAAwMD/AAAAAABkAAAAMgAAAAAAAABkAAAAAAAAAH9/fwAKAAAAIgAAABgAAAAAAAAAAAAAAAAAAAAAAAAAAAAAAAAAAAAkAAAAJAAAAAAAAAAHAAAAAAAAAAAAAAAAAAAAAAAAAAAAAAAAAAAAf39/ACUAAABYAAAAAAAAAAAAAAAAAAAAAAAAAAAAAAAAAAAAAAAAAAAAAAAAAAAAAAAAAAAAAAA/AAAAAAAAAKCGAQAAAAAAAAAAAAAAAAAMAAAAAQAAAAAAAAAAAAAAAAAAAB8AAABUAAAAAAAABQAAAAEAAAAAAAAAAAAAAAAAAAAAAAAAAAAAAAAAAAAAAAAAAAAAAAB/f38AAAAAA8zMzADAwP8Af39/AAAAAAAAAAAAAAAAAAAAAAAAAAAAIQAAABgAAAAUAAAACAcAADgEAAAoIwAAUBkAABAAAAAmAAAACAAAAAEPAAAAAAAA"/>
+                <pr:smNativeData xmlns:pr="smNativeData" xmlns="smNativeData" val="SMDATA_15_FUV5ZhMAAAAlAAAACwAAAA0AAAAACAcAADgEAAAoIwAAUBkAAAAAAAAAAAAAAAAAAAEAAABQAAAAAAAAAAAA4D8AAAAAAADgPwAAAAAAAOA/AAAAAAAA4D8AAAAAAADgPwAAAAAAAOA/AAAAAAAA4D8AAAAAAADgPwAAAAAAAOA/AAAAAAAA4D8CAAAAjAAAAAAAAAAAAAAAQoX0DP///wgAAAAAAAAAAAAAAAAAAAAAAAAAAAAAAAAAAAAAZAAAAAEAAABAAAAAAAAAAAAAAAAAAAAAAAAAAAAAAAAAAAAAAAAAAAAAAAAAAAAAAAAAAAAAAAAAAAAAAAAAAAAAAAAAAAAAAAAAAAAAAAAAAAAAAAAAAAAAAAAAAAAAFAAAADwAAAABAAAAAAAAAAAAAAAPAAAAAQAAACMAAAAjAAAAIwAAAB4AAAAAAAAASwAAAEsAAAAAAAAASwAAAEsAAAAVAAAAYAAAAAAAAAAAAAAADwAAACADAAAAAAAAAAAAAAEAAACgMgAAVgcAAKr4//8BAAAAf39/AAEAAABkAAAAAAAAABQAAABAHwAAAAAAACYAAAAAAAAAwOD//wAAAAAmAAAAZAAAABYAAABMAAAAAAAAAAAAAAAEAAAAAAAAAAEAAABZWVkKAAAAACgAAAAoAAAAZAAAAGQAAAAAAAAAzMzMAAAAAABQAAAAUAAAAGQAAABkAAAAAAAAABcAAAAUAAAAAAAAAAAAAAD/fwAA/38AAAAAAAAJAAAABAAAAAAAAAAeAAAAaAAAAAAAAAAAAAAAAAAAAAAAAAAAAAAAECcAABAnAAAAAAAAAAAAAAAAAAAAAAAAAAAAAAAAAAAAAAAAAAAAABQAAAAAAAAAwMD/AAAAAABkAAAAMgAAAAAAAABkAAAAAAAAAH9/fwAKAAAAIgAAABgAAAAAAAAAAAAAAAAAAAAAAAAAAAAAAAAAAAAkAAAAJAAAAAAAAAAHAAAAAAAAAAAAAAAAAAAAAAAAAAAAAAAAAAAAf39/ACUAAABYAAAAAAAAAAAAAAAAAAAAAAAAAAAAAAAAAAAAAAAAAAAAAAAAAAAAAAAAAAAAAAA/AAAAAAAAAKCGAQAAAAAAAAAAAAAAAAAMAAAAAQAAAAAAAAAAAAAAAAAAAB8AAABUAAAAAAAABQAAAAEAAAAAAAAAAAAAAAAAAAAAAAAAAAAAAAAAAAAAAAAAAAAAAAB/f38AAAAAA8zMzADAwP8Af39/AAAAAAAAAAAAAAAAAAAAAAAAAAAAIQAAABgAAAAUAAAACAcAADgEAAAoIwAAUBkAABAAAAAmAAAACAAAAAEPAAAAAAAA"/>
               </a:ext>
             </a:extLst>
           </p:cNvSpPr>
@@ -1604,7 +1604,7 @@
             <a:spLocks noGrp="1" noChangeArrowheads="1"/>
             <a:extLst>
               <a:ext uri="smNativeData">
-                <pr:smNativeData xmlns:pr="smNativeData" xmlns="smNativeData" val="SMDATA_15_LkR5ZhMAAAAlAAAAZAAAAA0AAAAAkAAAAJAAAACQAAAAkAAAAAAAAAAAAAAAAAAAAAEAAABQAAAAAAAAAAAA4D8AAAAAAADgPwAAAAAAAOA/AAAAAAAA4D8AAAAAAADgPwAAAAAAAOA/AAAAAAAA4D8AAAAAAADgPwAAAAAAAOA/AAAAAAAA4D8CAAAAjAAAAAAAAAAAAAAAQoX0DP///wgAAAAAAAAAAAAAAAAAAAAAAAAAAAAAAAAAAAAAZAAAAAEAAABAAAAAAAAAAAAAAAAAAAAAAAAAAAAAAAAAAAAAAAAAAAAAAAAAAAAAAAAAAAAAAAAAAAAAAAAAAAAAAAAAAAAAAAAAAAAAAAAAAAAAAAAAAAAAAAAAAAAAFAAAADwAAAAAAAAAAAAAAAAAAAkUAAAAAQAAABQAAAAUAAAAFAAAAAEAAAAAAAAAZAAAAGQAAAAAAAAAZAAAAGQAAAAVAAAAYAAAAAAAAAAAAAAADwAAACADAAAAAAAAAAAAAAEAAACgMgAAVgcAAKr4//8BAAAAf39/AAEAAABkAAAAAAAAABQAAABAHwAAAAAAACYAAAAAAAAAwOD//wAAAAAmAAAAZAAAABYAAABMAAAAAAAAAAAAAAAEAAAAAAAAAAEAAABZWVkKAAAAACgAAAAoAAAAZAAAAGQAAAAAAAAAzMzMAAAAAABQAAAAUAAAAGQAAABkAAAAAAAAABcAAAAUAAAAAAAAAAAAAAD/fwAA/38AAAAAAAAJAAAABAAAAKMkqfweAAAAaAAAAAAAAAAAAAAAAAAAAAAAAAAAAAAAECcAABAnAAAAAAAAAAAAAAAAAAAAAAAAAAAAAAAAAAAAAAAAAAAAABQAAAAAAAAAwMD/AAAAAABkAAAAMgAAAAAAAABkAAAAAAAAAH9/fwAKAAAAIgAAABgAAAAAAAAAAAAAAAAAAAAAAAAAAAAAAAAAAAAkAAAAJAAAAAAAAAAHAAAAAAAAAAAAAAAAAAAAAAAAAAAAAAAAAAAAf39/ACUAAABYAAAAAAAAAAAAAAAAAAAAAAAAAAAAAAAAAAAAAAAAAAAAAAAAAAAAAAAAAAAAAAA/AAAAAAAAAKCGAQAAAAAAAAAAAAAAAAAMAAAAAQAAAAAAAAAAAAAAAAAAAB8AAABUAAAAAAAABQAAAAEAAAAAAAAAAAAAAAAAAAAAAAAAAAAAAAAAAAAAAAAAAAAAAAJ/f38AAAAAA8zMzADAwP8Af39/AAAAAAAAAAAAAAAAAAAAAAAAAAAAIQAAABgAAAAUAAAAOAQAALgaAAD4JQAACDQAABAAAAAmAAAACAAAAL0/AAAAAAAA"/>
+                <pr:smNativeData xmlns:pr="smNativeData" xmlns="smNativeData" val="SMDATA_15_FUV5ZhMAAAAlAAAAZAAAAA0AAAAAkAAAAJAAAACQAAAAkAAAAAAAAAAAAAAAAAAAAAEAAABQAAAAAAAAAAAA4D8AAAAAAADgPwAAAAAAAOA/AAAAAAAA4D8AAAAAAADgPwAAAAAAAOA/AAAAAAAA4D8AAAAAAADgPwAAAAAAAOA/AAAAAAAA4D8CAAAAjAAAAAAAAAAAAAAAQoX0DP///wgAAAAAAAAAAAAAAAAAAAAAAAAAAAAAAAAAAAAAZAAAAAEAAABAAAAAAAAAAAAAAAAAAAAAAAAAAAAAAAAAAAAAAAAAAAAAAAAAAAAAAAAAAAAAAAAAAAAAAAAAAAAAAAAAAAAAAAAAAAAAAAAAAAAAAAAAAAAAAAAAAAAAFAAAADwAAAAAAAAAAAAAAAAAAAkUAAAAAQAAABQAAAAUAAAAFAAAAAEAAAAAAAAAZAAAAGQAAAAAAAAAZAAAAGQAAAAVAAAAYAAAAAAAAAAAAAAADwAAACADAAAAAAAAAAAAAAEAAACgMgAAVgcAAKr4//8BAAAAf39/AAEAAABkAAAAAAAAABQAAABAHwAAAAAAACYAAAAAAAAAwOD//wAAAAAmAAAAZAAAABYAAABMAAAAAAAAAAAAAAAEAAAAAAAAAAEAAABZWVkKAAAAACgAAAAoAAAAZAAAAGQAAAAAAAAAzMzMAAAAAABQAAAAUAAAAGQAAABkAAAAAAAAABcAAAAUAAAAAAAAAAAAAAD/fwAA/38AAAAAAAAJAAAABAAAAKMkqfweAAAAaAAAAAAAAAAAAAAAAAAAAAAAAAAAAAAAECcAABAnAAAAAAAAAAAAAAAAAAAAAAAAAAAAAAAAAAAAAAAAAAAAABQAAAAAAAAAwMD/AAAAAABkAAAAMgAAAAAAAABkAAAAAAAAAH9/fwAKAAAAIgAAABgAAAAAAAAAAAAAAAAAAAAAAAAAAAAAAAAAAAAkAAAAJAAAAAAAAAAHAAAAAAAAAAAAAAAAAAAAAAAAAAAAAAAAAAAAf39/ACUAAABYAAAAAAAAAAAAAAAAAAAAAAAAAAAAAAAAAAAAAAAAAAAAAAAAAAAAAAAAAAAAAAA/AAAAAAAAAKCGAQAAAAAAAAAAAAAAAAAMAAAAAQAAAAAAAAAAAAAAAAAAAB8AAABUAAAAAAAABQAAAAEAAAAAAAAAAAAAAAAAAAAAAAAAAAAAAAAAAAAAAAAAAAAAAAJ/f38AAAAAA8zMzADAwP8Af39/AAAAAAAAAAAAAAAAAAAAAAAAAAAAIQAAABgAAAAUAAAAOAQAALgaAAD4JQAACDQAABAAAAAmAAAACAAAAL0/AAAAAAAA"/>
               </a:ext>
             </a:extLst>
           </p:cNvSpPr>
@@ -1681,7 +1681,7 @@
             <a:spLocks noGrp="1" noChangeArrowheads="1"/>
             <a:extLst>
               <a:ext uri="smNativeData">
-                <pr:smNativeData xmlns:pr="smNativeData" xmlns="smNativeData" val="SMDATA_15_LkR5ZhMAAAAlAAAACwAAAA0AAAAACAcAADgEAAAoIwAAUBkAAAAAAAAAAAAAAAAAAAEAAABQAAAAAAAAAAAA4D8AAAAAAADgPwAAAAAAAOA/AAAAAAAA4D8AAAAAAADgPwAAAAAAAOA/AAAAAAAA4D8AAAAAAADgPwAAAAAAAOA/AAAAAAAA4D8CAAAAjAAAAAAAAAAAAAAAQoX0DP///wgAAAAAAAAAAAAAAAAAAAAAAAAAAAAAAAAAAAAAZAAAAAEAAABAAAAAAAAAAAAAAAAAAAAAAAAAAAAAAAAAAAAAAAAAAAAAAAAAAAAAAAAAAAAAAAAAAAAAAAAAAAAAAAAAAAAAAAAAAAAAAAAAAAAAAAAAAAAAAAAAAAAAFAAAADwAAAABAAAAAAAAAAAAAAAPAAAAAQAAACMAAAAjAAAAIwAAAB4AAAAAAAAASwAAAEsAAAAAAAAASwAAAEsAAAAVAAAAYAAAAAAAAAAAAAAADwAAACADAAAAAAAAAAAAAAEAAACgMgAAVgcAAKr4//8BAAAAf39/AAEAAABkAAAAAAAAABQAAABAHwAAAAAAACYAAAAAAAAAwOD//wAAAAAmAAAAZAAAABYAAABMAAAAAAAAAAAAAAAEAAAAAAAAAAEAAABZWVkKAAAAACgAAAAoAAAAZAAAAGQAAAAAAAAAzMzMAAAAAABQAAAAUAAAAGQAAABkAAAAAAAAABcAAAAUAAAAAAAAAAAAAAD/fwAA/38AAAAAAAAJAAAABAAAAAAAAAAeAAAAaAAAAAAAAAAAAAAAAAAAAAAAAAAAAAAAECcAABAnAAAAAAAAAAAAAAAAAAAAAAAAAAAAAAAAAAAAAAAAAAAAABQAAAAAAAAAwMD/AAAAAABkAAAAMgAAAAAAAABkAAAAAAAAAH9/fwAKAAAAIgAAABgAAAAAAAAAAAAAAAAAAAAAAAAAAAAAAAAAAAAkAAAAJAAAAAAAAAAHAAAAAAAAAAAAAAAAAAAAAAAAAAAAAAAAAAAAf39/ACUAAABYAAAAAAAAAAAAAAAAAAAAAAAAAAAAAAAAAAAAAAAAAAAAAAAAAAAAAAAAAAAAAAA/AAAAAAAAAKCGAQAAAAAAAAAAAAAAAAAMAAAAAQAAAAAAAAAAAAAAAAAAAB8AAABUAAAAAAAABQAAAAEAAAAAAAAAAAAAAAAAAAAAAAAAAAAAAAAAAAAAAAAAAAAAAAB/f38AAAAAA8zMzADAwP8Af39/AAAAAAAAAAAAAAAAAAAAAAAAAAAAIQAAABgAAAAUAAAACAcAADgEAAAoIwAAUBkAABAAAAAmAAAACAAAAAEPAAAAAAAA"/>
+                <pr:smNativeData xmlns:pr="smNativeData" xmlns="smNativeData" val="SMDATA_15_FUV5ZhMAAAAlAAAACwAAAA0AAAAACAcAADgEAAAoIwAAUBkAAAAAAAAAAAAAAAAAAAEAAABQAAAAAAAAAAAA4D8AAAAAAADgPwAAAAAAAOA/AAAAAAAA4D8AAAAAAADgPwAAAAAAAOA/AAAAAAAA4D8AAAAAAADgPwAAAAAAAOA/AAAAAAAA4D8CAAAAjAAAAAAAAAAAAAAAQoX0DP///wgAAAAAAAAAAAAAAAAAAAAAAAAAAAAAAAAAAAAAZAAAAAEAAABAAAAAAAAAAAAAAAAAAAAAAAAAAAAAAAAAAAAAAAAAAAAAAAAAAAAAAAAAAAAAAAAAAAAAAAAAAAAAAAAAAAAAAAAAAAAAAAAAAAAAAAAAAAAAAAAAAAAAFAAAADwAAAABAAAAAAAAAAAAAAAPAAAAAQAAACMAAAAjAAAAIwAAAB4AAAAAAAAASwAAAEsAAAAAAAAASwAAAEsAAAAVAAAAYAAAAAAAAAAAAAAADwAAACADAAAAAAAAAAAAAAEAAACgMgAAVgcAAKr4//8BAAAAf39/AAEAAABkAAAAAAAAABQAAABAHwAAAAAAACYAAAAAAAAAwOD//wAAAAAmAAAAZAAAABYAAABMAAAAAAAAAAAAAAAEAAAAAAAAAAEAAABZWVkKAAAAACgAAAAoAAAAZAAAAGQAAAAAAAAAzMzMAAAAAABQAAAAUAAAAGQAAABkAAAAAAAAABcAAAAUAAAAAAAAAAAAAAD/fwAA/38AAAAAAAAJAAAABAAAAAAAAAAeAAAAaAAAAAAAAAAAAAAAAAAAAAAAAAAAAAAAECcAABAnAAAAAAAAAAAAAAAAAAAAAAAAAAAAAAAAAAAAAAAAAAAAABQAAAAAAAAAwMD/AAAAAABkAAAAMgAAAAAAAABkAAAAAAAAAH9/fwAKAAAAIgAAABgAAAAAAAAAAAAAAAAAAAAAAAAAAAAAAAAAAAAkAAAAJAAAAAAAAAAHAAAAAAAAAAAAAAAAAAAAAAAAAAAAAAAAAAAAf39/ACUAAABYAAAAAAAAAAAAAAAAAAAAAAAAAAAAAAAAAAAAAAAAAAAAAAAAAAAAAAAAAAAAAAA/AAAAAAAAAKCGAQAAAAAAAAAAAAAAAAAMAAAAAQAAAAAAAAAAAAAAAAAAAB8AAABUAAAAAAAABQAAAAEAAAAAAAAAAAAAAAAAAAAAAAAAAAAAAAAAAAAAAAAAAAAAAAB/f38AAAAAA8zMzADAwP8Af39/AAAAAAAAAAAAAAAAAAAAAAAAAAAAIQAAABgAAAAUAAAACAcAADgEAAAoIwAAUBkAABAAAAAmAAAACAAAAAEPAAAAAAAA"/>
               </a:ext>
             </a:extLst>
           </p:cNvSpPr>
@@ -1727,7 +1727,7 @@
             <a:spLocks noGrp="1" noChangeArrowheads="1"/>
             <a:extLst>
               <a:ext uri="smNativeData">
-                <pr:smNativeData xmlns:pr="smNativeData" xmlns="smNativeData" val="SMDATA_15_LkR5ZhMAAAAlAAAAZAAAAA0AAAAAkAAAAJAAAACQAAAAkAAAAAAAAAAAAAAAAAAAAAEAAABQAAAAAAAAAAAA4D8AAAAAAADgPwAAAAAAAOA/AAAAAAAA4D8AAAAAAADgPwAAAAAAAOA/AAAAAAAA4D8AAAAAAADgPwAAAAAAAOA/AAAAAAAA4D8CAAAAjAAAAAAAAAAAAAAAQoX0DP///wgAAAAAAAAAAAAAAAAAAAAAAAAAAAAAAAAAAAAAZAAAAAEAAABAAAAAAAAAAAAAAAAAAAAAAAAAAAAAAAAAAAAAAAAAAAAAAAAAAAAAAAAAAAAAAAAAAAAAAAAAAAAAAAAAAAAAAAAAAAAAAAAAAAAAAAAAAAAAAAAAAAAAFAAAADwAAAAAAAAAAAAAAAAAAAkUAAAAAQAAABQAAAAUAAAAFAAAAAEAAAAAAAAAZAAAAGQAAAAAAAAAZAAAAGQAAAAVAAAAYAAAAAAAAAAAAAAADwAAACADAAAAAAAAAAAAAAEAAACgMgAAVgcAAKr4//8BAAAAf39/AAEAAABkAAAAAAAAABQAAABAHwAAAAAAACYAAAAAAAAAwOD//wAAAAAmAAAAZAAAABYAAABMAAAAAAAAAAAAAAAEAAAAAAAAAAEAAABZWVkKAAAAACgAAAAoAAAAZAAAAGQAAAAAAAAAzMzMAAAAAABQAAAAUAAAAGQAAABkAAAAAAAAABcAAAAUAAAAAAAAAAAAAAD/fwAA/38AAAAAAAAJAAAABAAAAF8AYAAeAAAAaAAAAAAAAAAAAAAAAAAAAAAAAAAAAAAAECcAABAnAAAAAAAAAAAAAAAAAAAAAAAAAAAAAAAAAAAAAAAAAAAAABQAAAAAAAAAwMD/AAAAAABkAAAAMgAAAAAAAABkAAAAAAAAAH9/fwAKAAAAIgAAABgAAAAAAAAAAAAAAAAAAAAAAAAAAAAAAAAAAAAkAAAAJAAAAAAAAAAHAAAAAAAAAAAAAAAAAAAAAAAAAAAAAAAAAAAAf39/ACUAAABYAAAAAAAAAAAAAAAAAAAAAAAAAAAAAAAAAAAAAAAAAAAAAAAAAAAAAAAAAAAAAAA/AAAAAAAAAKCGAQAAAAAAAAAAAAAAAAAMAAAAAQAAAAAAAAAAAAAAAAAAAB8AAABUAAAAAAAABQAAAAEAAAAAAAAAAAAAAAAAAAAAAAAAAAAAAAAAAAAAAAAAAAAAAAJ/f38AAAAAA8zMzADAwP8Af39/AAAAAAAAAAAAAAAAAAAAAAAAAAAAIQAAABgAAAAUAAAAOAQAALgaAAD4JQAACDQAABAAAAAmAAAACAAAAL0/AAAAAAAA"/>
+                <pr:smNativeData xmlns:pr="smNativeData" xmlns="smNativeData" val="SMDATA_15_FUV5ZhMAAAAlAAAAZAAAAA0AAAAAkAAAAJAAAACQAAAAkAAAAAAAAAAAAAAAAAAAAAEAAABQAAAAAAAAAAAA4D8AAAAAAADgPwAAAAAAAOA/AAAAAAAA4D8AAAAAAADgPwAAAAAAAOA/AAAAAAAA4D8AAAAAAADgPwAAAAAAAOA/AAAAAAAA4D8CAAAAjAAAAAAAAAAAAAAAQoX0DP///wgAAAAAAAAAAAAAAAAAAAAAAAAAAAAAAAAAAAAAZAAAAAEAAABAAAAAAAAAAAAAAAAAAAAAAAAAAAAAAAAAAAAAAAAAAAAAAAAAAAAAAAAAAAAAAAAAAAAAAAAAAAAAAAAAAAAAAAAAAAAAAAAAAAAAAAAAAAAAAAAAAAAAFAAAADwAAAAAAAAAAAAAAAAAAAkUAAAAAQAAABQAAAAUAAAAFAAAAAEAAAAAAAAAZAAAAGQAAAAAAAAAZAAAAGQAAAAVAAAAYAAAAAAAAAAAAAAADwAAACADAAAAAAAAAAAAAAEAAACgMgAAVgcAAKr4//8BAAAAf39/AAEAAABkAAAAAAAAABQAAABAHwAAAAAAACYAAAAAAAAAwOD//wAAAAAmAAAAZAAAABYAAABMAAAAAAAAAAAAAAAEAAAAAAAAAAEAAABZWVkKAAAAACgAAAAoAAAAZAAAAGQAAAAAAAAAzMzMAAAAAABQAAAAUAAAAGQAAABkAAAAAAAAABcAAAAUAAAAAAAAAAAAAAD/fwAA/38AAAAAAAAJAAAABAAAAF8AYAAeAAAAaAAAAAAAAAAAAAAAAAAAAAAAAAAAAAAAECcAABAnAAAAAAAAAAAAAAAAAAAAAAAAAAAAAAAAAAAAAAAAAAAAABQAAAAAAAAAwMD/AAAAAABkAAAAMgAAAAAAAABkAAAAAAAAAH9/fwAKAAAAIgAAABgAAAAAAAAAAAAAAAAAAAAAAAAAAAAAAAAAAAAkAAAAJAAAAAAAAAAHAAAAAAAAAAAAAAAAAAAAAAAAAAAAAAAAAAAAf39/ACUAAABYAAAAAAAAAAAAAAAAAAAAAAAAAAAAAAAAAAAAAAAAAAAAAAAAAAAAAAAAAAAAAAA/AAAAAAAAAKCGAQAAAAAAAAAAAAAAAAAMAAAAAQAAAAAAAAAAAAAAAAAAAB8AAABUAAAAAAAABQAAAAEAAAAAAAAAAAAAAAAAAAAAAAAAAAAAAAAAAAAAAAAAAAAAAAJ/f38AAAAAA8zMzADAwP8Af39/AAAAAAAAAAAAAAAAAAAAAAAAAAAAIQAAABgAAAAUAAAAOAQAALgaAAD4JQAACDQAABAAAAAmAAAACAAAAL0/AAAAAAAA"/>
               </a:ext>
             </a:extLst>
           </p:cNvSpPr>
@@ -1804,7 +1804,7 @@
             <a:spLocks noGrp="1" noChangeArrowheads="1"/>
             <a:extLst>
               <a:ext uri="smNativeData">
-                <pr:smNativeData xmlns:pr="smNativeData" xmlns="smNativeData" val="SMDATA_15_LkR5ZhMAAAAlAAAACwAAAA0AAAAACAcAADgEAAAoIwAAUBkAAAAAAAAAAAAAAAAAAAEAAABQAAAAAAAAAAAA4D8AAAAAAADgPwAAAAAAAOA/AAAAAAAA4D8AAAAAAADgPwAAAAAAAOA/AAAAAAAA4D8AAAAAAADgPwAAAAAAAOA/AAAAAAAA4D8CAAAAjAAAAAAAAAAAAAAAQoX0DP///wgAAAAAAAAAAAAAAAAAAAAAAAAAAAAAAAAAAAAAZAAAAAEAAABAAAAAAAAAAAAAAAAAAAAAAAAAAAAAAAAAAAAAAAAAAAAAAAAAAAAAAAAAAAAAAAAAAAAAAAAAAAAAAAAAAAAAAAAAAAAAAAAAAAAAAAAAAAAAAAAAAAAAFAAAADwAAAABAAAAAAAAAAAAAAAPAAAAAQAAACMAAAAjAAAAIwAAAB4AAAAAAAAASwAAAEsAAAAAAAAASwAAAEsAAAAVAAAAYAAAAAAAAAAAAAAADwAAACADAAAAAAAAAAAAAAEAAACgMgAAVgcAAKr4//8BAAAAf39/AAEAAABkAAAAAAAAABQAAABAHwAAAAAAACYAAAAAAAAAwOD//wAAAAAmAAAAZAAAABYAAABMAAAAAAAAAAAAAAAEAAAAAAAAAAEAAABZWVkKAAAAACgAAAAoAAAAZAAAAGQAAAAAAAAAzMzMAAAAAABQAAAAUAAAAGQAAABkAAAAAAAAABcAAAAUAAAAAAAAAAAAAAD/fwAA/38AAAAAAAAJAAAABAAAAAAAAAAeAAAAaAAAAAAAAAAAAAAAAAAAAAAAAAAAAAAAECcAABAnAAAAAAAAAAAAAAAAAAAAAAAAAAAAAAAAAAAAAAAAAAAAABQAAAAAAAAAwMD/AAAAAABkAAAAMgAAAAAAAABkAAAAAAAAAH9/fwAKAAAAIgAAABgAAAAAAAAAAAAAAAAAAAAAAAAAAAAAAAAAAAAkAAAAJAAAAAAAAAAHAAAAAAAAAAAAAAAAAAAAAAAAAAAAAAAAAAAAf39/ACUAAABYAAAAAAAAAAAAAAAAAAAAAAAAAAAAAAAAAAAAAAAAAAAAAAAAAAAAAAAAAAAAAAA/AAAAAAAAAKCGAQAAAAAAAAAAAAAAAAAMAAAAAQAAAAAAAAAAAAAAAAAAAB8AAABUAAAAAAAABQAAAAEAAAAAAAAAAAAAAAAAAAAAAAAAAAAAAAAAAAAAAAAAAAAAAAB/f38AAAAAA8zMzADAwP8Af39/AAAAAAAAAAAAAAAAAAAAAAAAAAAAIQAAABgAAAAUAAAACAcAADgEAAAoIwAAUBkAABAAAAAmAAAACAAAAAEPAAAAAAAA"/>
+                <pr:smNativeData xmlns:pr="smNativeData" xmlns="smNativeData" val="SMDATA_15_FUV5ZhMAAAAlAAAACwAAAA0AAAAACAcAADgEAAAoIwAAUBkAAAAAAAAAAAAAAAAAAAEAAABQAAAAAAAAAAAA4D8AAAAAAADgPwAAAAAAAOA/AAAAAAAA4D8AAAAAAADgPwAAAAAAAOA/AAAAAAAA4D8AAAAAAADgPwAAAAAAAOA/AAAAAAAA4D8CAAAAjAAAAAAAAAAAAAAAQoX0DP///wgAAAAAAAAAAAAAAAAAAAAAAAAAAAAAAAAAAAAAZAAAAAEAAABAAAAAAAAAAAAAAAAAAAAAAAAAAAAAAAAAAAAAAAAAAAAAAAAAAAAAAAAAAAAAAAAAAAAAAAAAAAAAAAAAAAAAAAAAAAAAAAAAAAAAAAAAAAAAAAAAAAAAFAAAADwAAAABAAAAAAAAAAAAAAAPAAAAAQAAACMAAAAjAAAAIwAAAB4AAAAAAAAASwAAAEsAAAAAAAAASwAAAEsAAAAVAAAAYAAAAAAAAAAAAAAADwAAACADAAAAAAAAAAAAAAEAAACgMgAAVgcAAKr4//8BAAAAf39/AAEAAABkAAAAAAAAABQAAABAHwAAAAAAACYAAAAAAAAAwOD//wAAAAAmAAAAZAAAABYAAABMAAAAAAAAAAAAAAAEAAAAAAAAAAEAAABZWVkKAAAAACgAAAAoAAAAZAAAAGQAAAAAAAAAzMzMAAAAAABQAAAAUAAAAGQAAABkAAAAAAAAABcAAAAUAAAAAAAAAAAAAAD/fwAA/38AAAAAAAAJAAAABAAAAAAAAAAeAAAAaAAAAAAAAAAAAAAAAAAAAAAAAAAAAAAAECcAABAnAAAAAAAAAAAAAAAAAAAAAAAAAAAAAAAAAAAAAAAAAAAAABQAAAAAAAAAwMD/AAAAAABkAAAAMgAAAAAAAABkAAAAAAAAAH9/fwAKAAAAIgAAABgAAAAAAAAAAAAAAAAAAAAAAAAAAAAAAAAAAAAkAAAAJAAAAAAAAAAHAAAAAAAAAAAAAAAAAAAAAAAAAAAAAAAAAAAAf39/ACUAAABYAAAAAAAAAAAAAAAAAAAAAAAAAAAAAAAAAAAAAAAAAAAAAAAAAAAAAAAAAAAAAAA/AAAAAAAAAKCGAQAAAAAAAAAAAAAAAAAMAAAAAQAAAAAAAAAAAAAAAAAAAB8AAABUAAAAAAAABQAAAAEAAAAAAAAAAAAAAAAAAAAAAAAAAAAAAAAAAAAAAAAAAAAAAAB/f38AAAAAA8zMzADAwP8Af39/AAAAAAAAAAAAAAAAAAAAAAAAAAAAIQAAABgAAAAUAAAACAcAADgEAAAoIwAAUBkAABAAAAAmAAAACAAAAAEPAAAAAAAA"/>
               </a:ext>
             </a:extLst>
           </p:cNvSpPr>
@@ -1850,7 +1850,7 @@
             <a:spLocks noGrp="1" noChangeArrowheads="1"/>
             <a:extLst>
               <a:ext uri="smNativeData">
-                <pr:smNativeData xmlns:pr="smNativeData" xmlns="smNativeData" val="SMDATA_15_LkR5ZhMAAAAlAAAAZAAAAA0AAAAAkAAAAJAAAACQAAAAkAAAAAAAAAAAAAAAAAAAAAEAAABQAAAAAAAAAAAA4D8AAAAAAADgPwAAAAAAAOA/AAAAAAAA4D8AAAAAAADgPwAAAAAAAOA/AAAAAAAA4D8AAAAAAADgPwAAAAAAAOA/AAAAAAAA4D8CAAAAjAAAAAAAAAAAAAAAQoX0DP///wgAAAAAAAAAAAAAAAAAAAAAAAAAAAAAAAAAAAAAZAAAAAEAAABAAAAAAAAAAAAAAAAAAAAAAAAAAAAAAAAAAAAAAAAAAAAAAAAAAAAAAAAAAAAAAAAAAAAAAAAAAAAAAAAAAAAAAAAAAAAAAAAAAAAAAAAAAAAAAAAAAAAAFAAAADwAAAAAAAAAAAAAAAAAAAkUAAAAAQAAABQAAAAUAAAAFAAAAAEAAAAAAAAAZAAAAGQAAAAAAAAAZAAAAGQAAAAVAAAAYAAAAAAAAAAAAAAADwAAACADAAAAAAAAAAAAAAEAAACgMgAAVgcAAKr4//8BAAAAf39/AAEAAABkAAAAAAAAABQAAABAHwAAAAAAACYAAAAAAAAAwOD//wAAAAAmAAAAZAAAABYAAABMAAAAAAAAAAAAAAAEAAAAAAAAAAEAAABZWVkKAAAAACgAAAAoAAAAZAAAAGQAAAAAAAAAzMzMAAAAAABQAAAAUAAAAGQAAABkAAAAAAAAABcAAAAUAAAAAAAAAAAAAAD/fwAA/38AAAAAAAAJAAAABAAAAF8AYAAeAAAAaAAAAAAAAAAAAAAAAAAAAAAAAAAAAAAAECcAABAnAAAAAAAAAAAAAAAAAAAAAAAAAAAAAAAAAAAAAAAAAAAAABQAAAAAAAAAwMD/AAAAAABkAAAAMgAAAAAAAABkAAAAAAAAAH9/fwAKAAAAIgAAABgAAAAAAAAAAAAAAAAAAAAAAAAAAAAAAAAAAAAkAAAAJAAAAAAAAAAHAAAAAAAAAAAAAAAAAAAAAAAAAAAAAAAAAAAAf39/ACUAAABYAAAAAAAAAAAAAAAAAAAAAAAAAAAAAAAAAAAAAAAAAAAAAAAAAAAAAAAAAAAAAAA/AAAAAAAAAKCGAQAAAAAAAAAAAAAAAAAMAAAAAQAAAAAAAAAAAAAAAAAAAB8AAABUAAAAAAAABQAAAAEAAAAAAAAAAAAAAAAAAAAAAAAAAAAAAAAAAAAAAAAAAAAAAAJ/f38AAAAAA8zMzADAwP8Af39/AAAAAAAAAAAAAAAAAAAAAAAAAAAAIQAAABgAAAAUAAAAOAQAALgaAAD4JQAACDQAABAAAAAmAAAACAAAAL0/AAAAAAAA"/>
+                <pr:smNativeData xmlns:pr="smNativeData" xmlns="smNativeData" val="SMDATA_15_FUV5ZhMAAAAlAAAAZAAAAA0AAAAAkAAAAJAAAACQAAAAkAAAAAAAAAAAAAAAAAAAAAEAAABQAAAAAAAAAAAA4D8AAAAAAADgPwAAAAAAAOA/AAAAAAAA4D8AAAAAAADgPwAAAAAAAOA/AAAAAAAA4D8AAAAAAADgPwAAAAAAAOA/AAAAAAAA4D8CAAAAjAAAAAAAAAAAAAAAQoX0DP///wgAAAAAAAAAAAAAAAAAAAAAAAAAAAAAAAAAAAAAZAAAAAEAAABAAAAAAAAAAAAAAAAAAAAAAAAAAAAAAAAAAAAAAAAAAAAAAAAAAAAAAAAAAAAAAAAAAAAAAAAAAAAAAAAAAAAAAAAAAAAAAAAAAAAAAAAAAAAAAAAAAAAAFAAAADwAAAAAAAAAAAAAAAAAAAkUAAAAAQAAABQAAAAUAAAAFAAAAAEAAAAAAAAAZAAAAGQAAAAAAAAAZAAAAGQAAAAVAAAAYAAAAAAAAAAAAAAADwAAACADAAAAAAAAAAAAAAEAAACgMgAAVgcAAKr4//8BAAAAf39/AAEAAABkAAAAAAAAABQAAABAHwAAAAAAACYAAAAAAAAAwOD//wAAAAAmAAAAZAAAABYAAABMAAAAAAAAAAAAAAAEAAAAAAAAAAEAAABZWVkKAAAAACgAAAAoAAAAZAAAAGQAAAAAAAAAzMzMAAAAAABQAAAAUAAAAGQAAABkAAAAAAAAABcAAAAUAAAAAAAAAAAAAAD/fwAA/38AAAAAAAAJAAAABAAAAF8AYAAeAAAAaAAAAAAAAAAAAAAAAAAAAAAAAAAAAAAAECcAABAnAAAAAAAAAAAAAAAAAAAAAAAAAAAAAAAAAAAAAAAAAAAAABQAAAAAAAAAwMD/AAAAAABkAAAAMgAAAAAAAABkAAAAAAAAAH9/fwAKAAAAIgAAABgAAAAAAAAAAAAAAAAAAAAAAAAAAAAAAAAAAAAkAAAAJAAAAAAAAAAHAAAAAAAAAAAAAAAAAAAAAAAAAAAAAAAAAAAAf39/ACUAAABYAAAAAAAAAAAAAAAAAAAAAAAAAAAAAAAAAAAAAAAAAAAAAAAAAAAAAAAAAAAAAAA/AAAAAAAAAKCGAQAAAAAAAAAAAAAAAAAMAAAAAQAAAAAAAAAAAAAAAAAAAB8AAABUAAAAAAAABQAAAAEAAAAAAAAAAAAAAAAAAAAAAAAAAAAAAAAAAAAAAAAAAAAAAAJ/f38AAAAAA8zMzADAwP8Af39/AAAAAAAAAAAAAAAAAAAAAAAAAAAAIQAAABgAAAAUAAAAOAQAALgaAAD4JQAACDQAABAAAAAmAAAACAAAAL0/AAAAAAAA"/>
               </a:ext>
             </a:extLst>
           </p:cNvSpPr>
@@ -1927,7 +1927,7 @@
             <a:spLocks noGrp="1" noChangeArrowheads="1"/>
             <a:extLst>
               <a:ext uri="smNativeData">
-                <pr:smNativeData xmlns:pr="smNativeData" xmlns="smNativeData" val="SMDATA_15_LkR5ZhMAAAAlAAAACwAAAA0AAAAACAcAADgEAAAoIwAAUBkAAAAAAAAAAAAAAAAAAAEAAABQAAAAAAAAAAAA4D8AAAAAAADgPwAAAAAAAOA/AAAAAAAA4D8AAAAAAADgPwAAAAAAAOA/AAAAAAAA4D8AAAAAAADgPwAAAAAAAOA/AAAAAAAA4D8CAAAAjAAAAAAAAAAAAAAAQoX0DP///wgAAAAAAAAAAAAAAAAAAAAAAAAAAAAAAAAAAAAAZAAAAAEAAABAAAAAAAAAAAAAAAAAAAAAAAAAAAAAAAAAAAAAAAAAAAAAAAAAAAAAAAAAAAAAAAAAAAAAAAAAAAAAAAAAAAAAAAAAAAAAAAAAAAAAAAAAAAAAAAAAAAAAFAAAADwAAAABAAAAAAAAAAAAAAAPAAAAAQAAACMAAAAjAAAAIwAAAB4AAAAAAAAASwAAAEsAAAAAAAAASwAAAEsAAAAVAAAAYAAAAAAAAAAAAAAADwAAACADAAAAAAAAAAAAAAEAAACgMgAAVgcAAKr4//8BAAAAf39/AAEAAABkAAAAAAAAABQAAABAHwAAAAAAACYAAAAAAAAAwOD//wAAAAAmAAAAZAAAABYAAABMAAAAAAAAAAAAAAAEAAAAAAAAAAEAAABZWVkKAAAAACgAAAAoAAAAZAAAAGQAAAAAAAAAzMzMAAAAAABQAAAAUAAAAGQAAABkAAAAAAAAABcAAAAUAAAAAAAAAAAAAAD/fwAA/38AAAAAAAAJAAAABAAAAAAAAAAeAAAAaAAAAAAAAAAAAAAAAAAAAAAAAAAAAAAAECcAABAnAAAAAAAAAAAAAAAAAAAAAAAAAAAAAAAAAAAAAAAAAAAAABQAAAAAAAAAwMD/AAAAAABkAAAAMgAAAAAAAABkAAAAAAAAAH9/fwAKAAAAIgAAABgAAAAAAAAAAAAAAAAAAAAAAAAAAAAAAAAAAAAkAAAAJAAAAAAAAAAHAAAAAAAAAAAAAAAAAAAAAAAAAAAAAAAAAAAAf39/ACUAAABYAAAAAAAAAAAAAAAAAAAAAAAAAAAAAAAAAAAAAAAAAAAAAAAAAAAAAAAAAAAAAAA/AAAAAAAAAKCGAQAAAAAAAAAAAAAAAAAMAAAAAQAAAAAAAAAAAAAAAAAAAB8AAABUAAAAAAAABQAAAAEAAAAAAAAAAAAAAAAAAAAAAAAAAAAAAAAAAAAAAAAAAAAAAAB/f38AAAAAA8zMzADAwP8Af39/AAAAAAAAAAAAAAAAAAAAAAAAAAAAIQAAABgAAAAUAAAACAcAADgEAAAoIwAAUBkAABAAAAAmAAAACAAAAAEPAAAAAAAA"/>
+                <pr:smNativeData xmlns:pr="smNativeData" xmlns="smNativeData" val="SMDATA_15_FUV5ZhMAAAAlAAAACwAAAA0AAAAACAcAADgEAAAoIwAAUBkAAAAAAAAAAAAAAAAAAAEAAABQAAAAAAAAAAAA4D8AAAAAAADgPwAAAAAAAOA/AAAAAAAA4D8AAAAAAADgPwAAAAAAAOA/AAAAAAAA4D8AAAAAAADgPwAAAAAAAOA/AAAAAAAA4D8CAAAAjAAAAAAAAAAAAAAAQoX0DP///wgAAAAAAAAAAAAAAAAAAAAAAAAAAAAAAAAAAAAAZAAAAAEAAABAAAAAAAAAAAAAAAAAAAAAAAAAAAAAAAAAAAAAAAAAAAAAAAAAAAAAAAAAAAAAAAAAAAAAAAAAAAAAAAAAAAAAAAAAAAAAAAAAAAAAAAAAAAAAAAAAAAAAFAAAADwAAAABAAAAAAAAAAAAAAAPAAAAAQAAACMAAAAjAAAAIwAAAB4AAAAAAAAASwAAAEsAAAAAAAAASwAAAEsAAAAVAAAAYAAAAAAAAAAAAAAADwAAACADAAAAAAAAAAAAAAEAAACgMgAAVgcAAKr4//8BAAAAf39/AAEAAABkAAAAAAAAABQAAABAHwAAAAAAACYAAAAAAAAAwOD//wAAAAAmAAAAZAAAABYAAABMAAAAAAAAAAAAAAAEAAAAAAAAAAEAAABZWVkKAAAAACgAAAAoAAAAZAAAAGQAAAAAAAAAzMzMAAAAAABQAAAAUAAAAGQAAABkAAAAAAAAABcAAAAUAAAAAAAAAAAAAAD/fwAA/38AAAAAAAAJAAAABAAAAAAAAAAeAAAAaAAAAAAAAAAAAAAAAAAAAAAAAAAAAAAAECcAABAnAAAAAAAAAAAAAAAAAAAAAAAAAAAAAAAAAAAAAAAAAAAAABQAAAAAAAAAwMD/AAAAAABkAAAAMgAAAAAAAABkAAAAAAAAAH9/fwAKAAAAIgAAABgAAAAAAAAAAAAAAAAAAAAAAAAAAAAAAAAAAAAkAAAAJAAAAAAAAAAHAAAAAAAAAAAAAAAAAAAAAAAAAAAAAAAAAAAAf39/ACUAAABYAAAAAAAAAAAAAAAAAAAAAAAAAAAAAAAAAAAAAAAAAAAAAAAAAAAAAAAAAAAAAAA/AAAAAAAAAKCGAQAAAAAAAAAAAAAAAAAMAAAAAQAAAAAAAAAAAAAAAAAAAB8AAABUAAAAAAAABQAAAAEAAAAAAAAAAAAAAAAAAAAAAAAAAAAAAAAAAAAAAAAAAAAAAAB/f38AAAAAA8zMzADAwP8Af39/AAAAAAAAAAAAAAAAAAAAAAAAAAAAIQAAABgAAAAUAAAACAcAADgEAAAoIwAAUBkAABAAAAAmAAAACAAAAAEPAAAAAAAA"/>
               </a:ext>
             </a:extLst>
           </p:cNvSpPr>
@@ -1973,7 +1973,7 @@
             <a:spLocks noGrp="1" noChangeArrowheads="1"/>
             <a:extLst>
               <a:ext uri="smNativeData">
-                <pr:smNativeData xmlns:pr="smNativeData" xmlns="smNativeData" val="SMDATA_15_LkR5ZhMAAAAlAAAAZAAAAA0AAAAAkAAAAJAAAACQAAAAkAAAAAAAAAAAAAAAAAAAAAEAAABQAAAAAAAAAAAA4D8AAAAAAADgPwAAAAAAAOA/AAAAAAAA4D8AAAAAAADgPwAAAAAAAOA/AAAAAAAA4D8AAAAAAADgPwAAAAAAAOA/AAAAAAAA4D8CAAAAjAAAAAAAAAAAAAAAQoX0DP///wgAAAAAAAAAAAAAAAAAAAAAAAAAAAAAAAAAAAAAZAAAAAEAAABAAAAAAAAAAAAAAAAAAAAAAAAAAAAAAAAAAAAAAAAAAAAAAAAAAAAAAAAAAAAAAAAAAAAAAAAAAAAAAAAAAAAAAAAAAAAAAAAAAAAAAAAAAAAAAAAAAAAAFAAAADwAAAAAAAAAAAAAAAAAAAkUAAAAAQAAABQAAAAUAAAAFAAAAAEAAAAAAAAAZAAAAGQAAAAAAAAAZAAAAGQAAAAVAAAAYAAAAAAAAAAAAAAADwAAACADAAAAAAAAAAAAAAEAAACgMgAAVgcAAKr4//8BAAAAf39/AAEAAABkAAAAAAAAABQAAABAHwAAAAAAACYAAAAAAAAAwOD//wAAAAAmAAAAZAAAABYAAABMAAAAAAAAAAAAAAAEAAAAAAAAAAEAAABZWVkKAAAAACgAAAAoAAAAZAAAAGQAAAAAAAAAzMzMAAAAAABQAAAAUAAAAGQAAABkAAAAAAAAABcAAAAUAAAAAAAAAAAAAAD/fwAA/38AAAAAAAAJAAAABAAAAPDbzXceAAAAaAAAAAAAAAAAAAAAAAAAAAAAAAAAAAAAECcAABAnAAAAAAAAAAAAAAAAAAAAAAAAAAAAAAAAAAAAAAAAAAAAABQAAAAAAAAAwMD/AAAAAABkAAAAMgAAAAAAAABkAAAAAAAAAH9/fwAKAAAAIgAAABgAAAAAAAAAAAAAAAAAAAAAAAAAAAAAAAAAAAAkAAAAJAAAAAAAAAAHAAAAAAAAAAAAAAAAAAAAAAAAAAAAAAAAAAAAf39/ACUAAABYAAAAAAAAAAAAAAAAAAAAAAAAAAAAAAAAAAAAAAAAAAAAAAAAAAAAAAAAAAAAAAA/AAAAAAAAAKCGAQAAAAAAAAAAAAAAAAAMAAAAAQAAAAAAAAAAAAAAAAAAAB8AAABUAAAAAAAABQAAAAEAAAAAAAAAAAAAAAAAAAAAAAAAAAAAAAAAAAAAAAAAAAAAAAJ/f38AAAAAA8zMzADAwP8Af39/AAAAAAAAAAAAAAAAAAAAAAAAAAAAIQAAABgAAAAUAAAAOAQAALgaAAD4JQAACDQAABAAAAAmAAAACAAAAL0/AAAAAAAA"/>
+                <pr:smNativeData xmlns:pr="smNativeData" xmlns="smNativeData" val="SMDATA_15_FUV5ZhMAAAAlAAAAZAAAAA0AAAAAkAAAAJAAAACQAAAAkAAAAAAAAAAAAAAAAAAAAAEAAABQAAAAAAAAAAAA4D8AAAAAAADgPwAAAAAAAOA/AAAAAAAA4D8AAAAAAADgPwAAAAAAAOA/AAAAAAAA4D8AAAAAAADgPwAAAAAAAOA/AAAAAAAA4D8CAAAAjAAAAAAAAAAAAAAAQoX0DP///wgAAAAAAAAAAAAAAAAAAAAAAAAAAAAAAAAAAAAAZAAAAAEAAABAAAAAAAAAAAAAAAAAAAAAAAAAAAAAAAAAAAAAAAAAAAAAAAAAAAAAAAAAAAAAAAAAAAAAAAAAAAAAAAAAAAAAAAAAAAAAAAAAAAAAAAAAAAAAAAAAAAAAFAAAADwAAAAAAAAAAAAAAAAAAAkUAAAAAQAAABQAAAAUAAAAFAAAAAEAAAAAAAAAZAAAAGQAAAAAAAAAZAAAAGQAAAAVAAAAYAAAAAAAAAAAAAAADwAAACADAAAAAAAAAAAAAAEAAACgMgAAVgcAAKr4//8BAAAAf39/AAEAAABkAAAAAAAAABQAAABAHwAAAAAAACYAAAAAAAAAwOD//wAAAAAmAAAAZAAAABYAAABMAAAAAAAAAAAAAAAEAAAAAAAAAAEAAABZWVkKAAAAACgAAAAoAAAAZAAAAGQAAAAAAAAAzMzMAAAAAABQAAAAUAAAAGQAAABkAAAAAAAAABcAAAAUAAAAAAAAAAAAAAD/fwAA/38AAAAAAAAJAAAABAAAAPDbzXceAAAAaAAAAAAAAAAAAAAAAAAAAAAAAAAAAAAAECcAABAnAAAAAAAAAAAAAAAAAAAAAAAAAAAAAAAAAAAAAAAAAAAAABQAAAAAAAAAwMD/AAAAAABkAAAAMgAAAAAAAABkAAAAAAAAAH9/fwAKAAAAIgAAABgAAAAAAAAAAAAAAAAAAAAAAAAAAAAAAAAAAAAkAAAAJAAAAAAAAAAHAAAAAAAAAAAAAAAAAAAAAAAAAAAAAAAAAAAAf39/ACUAAABYAAAAAAAAAAAAAAAAAAAAAAAAAAAAAAAAAAAAAAAAAAAAAAAAAAAAAAAAAAAAAAA/AAAAAAAAAKCGAQAAAAAAAAAAAAAAAAAMAAAAAQAAAAAAAAAAAAAAAAAAAB8AAABUAAAAAAAABQAAAAEAAAAAAAAAAAAAAAAAAAAAAAAAAAAAAAAAAAAAAAAAAAAAAAJ/f38AAAAAA8zMzADAwP8Af39/AAAAAAAAAAAAAAAAAAAAAAAAAAAAIQAAABgAAAAUAAAAOAQAALgaAAD4JQAACDQAABAAAAAmAAAACAAAAL0/AAAAAAAA"/>
               </a:ext>
             </a:extLst>
           </p:cNvSpPr>
@@ -2041,7 +2041,7 @@
           <p:cNvPicPr>
             <a:extLst>
               <a:ext uri="smNativeData">
-                <pr:smNativeData xmlns:pr="smNativeData" xmlns="smNativeData" val="SMDATA_17_LkR5ZhMAAAAlAAAAEQAAAA0AAAAAkAAAAEgAAACQAAAASAAAAAAAAAAAAAAAAAAAAAEAAABQAAAAAAAAAAAA4D8AAAAAAADgPwAAAAAAAOA/AAAAAAAA4D8AAAAAAADgPwAAAAAAAOA/AAAAAAAA4D8AAAAAAADgPwAAAAAAAOA/AAAAAAAA4D8CAAAAjAAAAAAAAAAAAAAAQoX0DP///wgAAAAAAAAAAAAAAAAAAAAAAAAAAAAAAAAAAAAAZAAAAAEAAABAAAAAAAAAAAAAAAAAAAAAAAAAAAAAAAAAAAAAAAAAAAAAAAAAAAAAAAAAAAAAAAAAAAAAAAAAAAAAAAAAAAAAAAAAAAAAAAAAAAAAAAAAAAAAAAAAAAAAFAAAADwAAAAAAAAAAAAAAAAAAAkUAAAAAQAAABQAAAAUAAAAFAAAAAEAAAAAAAAAZAAAAGQAAAAAAAAAZAAAAGQAAAAVAAAAYAAAAAAAAAAAAAAADwAAACADAAAAAAAAAAAAAAEAAACgMgAAVgcAAKr4//8BAAAAf39/AAEAAABkAAAAAAAAABQAAABAHwAAAAAAACYAAAAAAAAAwOD//wAAAAAmAAAAZAAAABYAAABMAAAAAAAAAAAAAAAEAAAAAAAAAAEAAABZWVkKAAAAACgAAAAoAAAAZAAAAGQAAAAAAAAAzMzMAAAAAABQAAAAUAAAAGQAAABkAAAAAAAAAAcAAAA4AAAAAAAAAAAAAAAAAAAA////AAAAAAAAAAAAAAAAAAAAAAAAAAAAAAAAAAAAAABkAAAAZAAAAAAAAAAjAAAABAAAAGQAAAAXAAAAFAAAAAAAAAAAAAAA/38AAP9/AAAAAAAACQAAAAQAAAAlAwAAHgAAAGgAAAAAAAAAAAAAAAAAAAAAAAAAAAAAABAnAAAQJwAAAAAAAAAAAAAAAAAAAAAAAAAAAAAAAAAAAAAAAAAAAAAUAAAAAAAAAMDA/wAAAAAAZAAAADIAAAAAAAAAZAAAAAAAAAB/f38ACgAAACIAAAAYAAAAAAAAAAAAAAAAAAAAAAAAAAAAAAAAAAAAJAAAACQAAAAAAAAABwAAAAAAAAAAAAAAAAAAAAAAAAAAAAAAAAAAAH9/fwAlAAAAWAAAAAAAAAAAAAAAAAAAAAAAAAAAAAAAAAAAAAAAAAAAAAAAAAAAAAAAAAAAAAAAPwAAAAAAAACghgEAAAAAAAAAAAAAAAAADAAAAAEAAAAAAAAAAAAAAAAAAAAfAAAAVAAAAEKF9AX///8BAAAAAAAAAAAAAAAAAAAAAAAAAAAAAAAAAAAAAAAAAAAAAAACf39/AFlZWQPMzMwAwMD/AH9/fwAAAAAAAAAAAAAAAAD///8AAAAAACEAAAAYAAAAFAAAAOT////r////XDgAAEUqAAAQAAAAJgAAAAgAAAD//////////w=="/>
+                <pr:smNativeData xmlns:pr="smNativeData" xmlns="smNativeData" val="SMDATA_17_FUV5ZhMAAAAlAAAAEQAAAA0AAAAAkAAAAEgAAACQAAAASAAAAAAAAAAAAAAAAAAAAAEAAABQAAAAAAAAAAAA4D8AAAAAAADgPwAAAAAAAOA/AAAAAAAA4D8AAAAAAADgPwAAAAAAAOA/AAAAAAAA4D8AAAAAAADgPwAAAAAAAOA/AAAAAAAA4D8CAAAAjAAAAAAAAAAAAAAAQoX0DP///wgAAAAAAAAAAAAAAAAAAAAAAAAAAAAAAAAAAAAAZAAAAAEAAABAAAAAAAAAAAAAAAAAAAAAAAAAAAAAAAAAAAAAAAAAAAAAAAAAAAAAAAAAAAAAAAAAAAAAAAAAAAAAAAAAAAAAAAAAAAAAAAAAAAAAAAAAAAAAAAAAAAAAFAAAADwAAAAAAAAAAAAAAAAAAAkUAAAAAQAAABQAAAAUAAAAFAAAAAEAAAAAAAAAZAAAAGQAAAAAAAAAZAAAAGQAAAAVAAAAYAAAAAAAAAAAAAAADwAAACADAAAAAAAAAAAAAAEAAACgMgAAVgcAAKr4//8BAAAAf39/AAEAAABkAAAAAAAAABQAAABAHwAAAAAAACYAAAAAAAAAwOD//wAAAAAmAAAAZAAAABYAAABMAAAAAAAAAAAAAAAEAAAAAAAAAAEAAABZWVkKAAAAACgAAAAoAAAAZAAAAGQAAAAAAAAAzMzMAAAAAABQAAAAUAAAAGQAAABkAAAAAAAAAAcAAAA4AAAAAAAAAAAAAAAAAAAA////AAAAAAAAAAAAAAAAAAAAAAAAAAAAAAAAAAAAAABkAAAAZAAAAAAAAAAjAAAABAAAAGQAAAAXAAAAFAAAAAAAAAAAAAAA/38AAP9/AAAAAAAACQAAAAQAAAAlAwAAHgAAAGgAAAAAAAAAAAAAAAAAAAAAAAAAAAAAABAnAAAQJwAAAAAAAAAAAAAAAAAAAAAAAAAAAAAAAAAAAAAAAAAAAAAUAAAAAAAAAMDA/wAAAAAAZAAAADIAAAAAAAAAZAAAAAAAAAB/f38ACgAAACIAAAAYAAAAAAAAAAAAAAAAAAAAAAAAAAAAAAAAAAAAJAAAACQAAAAAAAAABwAAAAAAAAAAAAAAAAAAAAAAAAAAAAAAAAAAAH9/fwAlAAAAWAAAAAAAAAAAAAAAAAAAAAAAAAAAAAAAAAAAAAAAAAAAAAAAAAAAAAAAAAAAAAAAPwAAAAAAAACghgEAAAAAAAAAAAAAAAAADAAAAAEAAAAAAAAAAAAAAAAAAAAfAAAAVAAAAEKF9AX///8BAAAAAAAAAAAAAAAAAAAAAAAAAAAAAAAAAAAAAAAAAAAAAAACf39/AFlZWQPMzMwAwMD/AH9/fwAAAAAAAAAAAAAAAAD///8AAAAAACEAAAAYAAAAFAAAAOT////r////XDgAAEUqAAAQAAAAJgAAAAgAAAD//////////w=="/>
               </a:ext>
             </a:extLst>
           </p:cNvPicPr>
@@ -2075,7 +2075,7 @@
             <a:spLocks noGrp="1" noChangeArrowheads="1"/>
             <a:extLst>
               <a:ext uri="smNativeData">
-                <pr:smNativeData xmlns:pr="smNativeData" xmlns="smNativeData" val="SMDATA_15_LkR5ZhMAAAAlAAAAZAAAAA0AAAAAkAAAAJAAAACQAAAAkAAAAAAAAAAAAAAAAAAAAAEAAABQAAAAAAAAAAAA4D8AAAAAAADgPwAAAAAAAOA/AAAAAAAA4D8AAAAAAADgPwAAAAAAAOA/AAAAAAAA4D8AAAAAAADgPwAAAAAAAOA/AAAAAAAA4D8CAAAAjAAAAAAAAAAAAAAAQoX0DP///wgAAAAAAAAAAAAAAAAAAAAAAAAAAAAAAAAAAAAAZAAAAAEAAABAAAAAAAAAAAAAAAAAAAAAAAAAAAAAAAAAAAAAAAAAAAAAAAAAAAAAAAAAAAAAAAAAAAAAAAAAAAAAAAAAAAAAAAAAAAAAAAAAAAAAAAAAAAAAAAAAAAAAFAAAADwAAAAAAAAAAAAAAAAAAAkUAAAAAQAAABQAAAAUAAAAFAAAAAEAAAAAAAAAZAAAAGQAAAAAAAAAZAAAAGQAAAAVAAAAYAAAAAAAAAAAAAAADwAAACADAAAAAAAAAAAAAAEAAACgMgAAVgcAAKr4//8BAAAAf39/AAEAAABkAAAAAAAAABQAAABAHwAAAAAAACYAAAAAAAAAwOD//wAAAAAmAAAAZAAAABYAAABMAAAAAAAAAAAAAAAEAAAAAAAAAAEAAABZWVkKAAAAACgAAAAoAAAAZAAAAGQAAAAAAAAAzMzMAAAAAABQAAAAUAAAAGQAAABkAAAAAAAAABcAAAAUAAAAAAAAAAAAAAD/fwAA/38AAAAAAAAJAAAABAAAAAAAAAAeAAAAaAAAAAAAAAAAAAAAAAAAAAAAAAAAAAAAECcAABAnAAAAAAAAAAAAAAAAAAAAAAAAAAAAAAAAAAAAAAAAAAAAABQAAAAAAAAAwMD/AAAAAABkAAAAMgAAAAAAAABkAAAAAAAAAH9/fwAKAAAAIgAAABgAAAAAAAAAAAAAAAAAAAAAAAAAAAAAAAAAAAAkAAAAJAAAAAAAAAAHAAAAAAAAAAAAAAAAAAAAAAAAAAAAAAAAAAAAf39/ACUAAABYAAAAAAAAAAAAAAAAAAAAAAAAAAAAAAAAAAAAAAAAAAAAAAAAAAAAAAAAAAAAAAA/AAAAAAAAAKCGAQAAAAAAAAAAAAAAAAAMAAAAAQAAAAAAAAAAAAAAAAAAAB8AAABUAAAAAAAABQAAAAEAAAAAAAAAAAAAAAAAAAAAAAAAAAAAAAAAAAAAAAAAAAAAAAJ/f38AAAAAA8zMzADAwP8Af39/AAAAAAAAAAAAAAAAAAAAAAAAAAAAIQAAABgAAAAUAAAA5wQAAD8jAAD6IwAAvykAABAAAAAmAAAACAAAAD2wAAAAAAAA"/>
+                <pr:smNativeData xmlns:pr="smNativeData" xmlns="smNativeData" val="SMDATA_15_FUV5ZhMAAAAlAAAAZAAAAA0AAAAAkAAAAJAAAACQAAAAkAAAAAAAAAAAAAAAAAAAAAEAAABQAAAAAAAAAAAA4D8AAAAAAADgPwAAAAAAAOA/AAAAAAAA4D8AAAAAAADgPwAAAAAAAOA/AAAAAAAA4D8AAAAAAADgPwAAAAAAAOA/AAAAAAAA4D8CAAAAjAAAAAAAAAAAAAAAQoX0DP///wgAAAAAAAAAAAAAAAAAAAAAAAAAAAAAAAAAAAAAZAAAAAEAAABAAAAAAAAAAAAAAAAAAAAAAAAAAAAAAAAAAAAAAAAAAAAAAAAAAAAAAAAAAAAAAAAAAAAAAAAAAAAAAAAAAAAAAAAAAAAAAAAAAAAAAAAAAAAAAAAAAAAAFAAAADwAAAAAAAAAAAAAAAAAAAkUAAAAAQAAABQAAAAUAAAAFAAAAAEAAAAAAAAAZAAAAGQAAAAAAAAAZAAAAGQAAAAVAAAAYAAAAAAAAAAAAAAADwAAACADAAAAAAAAAAAAAAEAAACgMgAAVgcAAKr4//8BAAAAf39/AAEAAABkAAAAAAAAABQAAABAHwAAAAAAACYAAAAAAAAAwOD//wAAAAAmAAAAZAAAABYAAABMAAAAAAAAAAAAAAAEAAAAAAAAAAEAAABZWVkKAAAAACgAAAAoAAAAZAAAAGQAAAAAAAAAzMzMAAAAAABQAAAAUAAAAGQAAABkAAAAAAAAABcAAAAUAAAAAAAAAAAAAAD/fwAA/38AAAAAAAAJAAAABAAAAAAAAAAeAAAAaAAAAAAAAAAAAAAAAAAAAAAAAAAAAAAAECcAABAnAAAAAAAAAAAAAAAAAAAAAAAAAAAAAAAAAAAAAAAAAAAAABQAAAAAAAAAwMD/AAAAAABkAAAAMgAAAAAAAABkAAAAAAAAAH9/fwAKAAAAIgAAABgAAAAAAAAAAAAAAAAAAAAAAAAAAAAAAAAAAAAkAAAAJAAAAAAAAAAHAAAAAAAAAAAAAAAAAAAAAAAAAAAAAAAAAAAAf39/ACUAAABYAAAAAAAAAAAAAAAAAAAAAAAAAAAAAAAAAAAAAAAAAAAAAAAAAAAAAAAAAAAAAAA/AAAAAAAAAKCGAQAAAAAAAAAAAAAAAAAMAAAAAQAAAAAAAAAAAAAAAAAAAB8AAABUAAAAAAAABQAAAAEAAAAAAAAAAAAAAAAAAAAAAAAAAAAAAAAAAAAAAAAAAAAAAAJ/f38AAAAAA8zMzADAwP8Af39/AAAAAAAAAAAAAAAAAAAAAAAAAAAAIQAAABgAAAAUAAAA5wQAAD8jAAD6IwAAvykAABAAAAAmAAAACAAAAD2wAAAAAAAA"/>
               </a:ext>
             </a:extLst>
           </p:cNvSpPr>
@@ -2230,7 +2230,7 @@
             <a:spLocks noGrp="1" noChangeArrowheads="1"/>
             <a:extLst>
               <a:ext uri="smNativeData">
-                <pr:smNativeData xmlns:pr="smNativeData" xmlns="smNativeData" val="SMDATA_15_LkR5ZhMAAAAlAAAAZAAAAA0AAAAAkAAAAJAAAACQAAAAkAAAAAAAAAAAAAAAAAAAAAEAAABQAAAAAAAAAAAA4D8AAAAAAADgPwAAAAAAAOA/AAAAAAAA4D8AAAAAAADgPwAAAAAAAOA/AAAAAAAA4D8AAAAAAADgPwAAAAAAAOA/AAAAAAAA4D8CAAAAjAAAAAAAAAAAAAAAQoX0DP///wgAAAAAAAAAAAAAAAAAAAAAAAAAAAAAAAAAAAAAZAAAAAEAAABAAAAAAAAAAAAAAAAAAAAAAAAAAAAAAAAAAAAAAAAAAAAAAAAAAAAAAAAAAAAAAAAAAAAAAAAAAAAAAAAAAAAAAAAAAAAAAAAAAAAAAAAAAAAAAAAAAAAAFAAAADwAAAAAAAAAAAAAAAAAAAkUAAAAAQAAABQAAAAUAAAAFAAAAAEAAAAAAAAAZAAAAGQAAAAAAAAAZAAAAGQAAAAVAAAAYAAAAAAAAAAAAAAADwAAACADAAAAAAAAAAAAAAEAAACgMgAAVgcAAKr4//8BAAAAf39/AAEAAABkAAAAAAAAABQAAABAHwAAAAAAACYAAAAAAAAAwOD//wAAAAAmAAAAZAAAABYAAABMAAAAAAAAAAAAAAAEAAAAAAAAAAEAAABZWVkKAAAAACgAAAAoAAAAZAAAAGQAAAAAAAAAzMzMAAAAAABQAAAAUAAAAGQAAABkAAAAAAAAABcAAAAUAAAAAAAAAAAAAAD/fwAA/38AAAAAAAAJAAAABAAAAAAAAAAeAAAAaAAAAAAAAAAAAAAAAAAAAAAAAAAAAAAAECcAABAnAAAAAAAAAAAAAAAAAAAAAAAAAAAAAAAAAAAAAAAAAAAAABQAAAAAAAAAwMD/AAAAAABkAAAAMgAAAAAAAABkAAAAAAAAAH9/fwAKAAAAIgAAABgAAAAAAAAAAAAAAAAAAAAAAAAAAAAAAAAAAAAkAAAAJAAAAAAAAAAHAAAAAAAAAAAAAAAAAAAAAAAAAAAAAAAAAAAAf39/ACUAAABYAAAAAAAAAAAAAAAAAAAAAAAAAAAAAAAAAAAAAAAAAAAAAAAAAAAAAAAAAAAAAAA/AAAAAAAAAKCGAQAAAAAAAAAAAAAAAAAMAAAAAQAAAAAAAAAAAAAAAAAAAB8AAABUAAAAAAAABQAAAAEAAAAAAAAAAAAAAAAAAAAAAAAAAAAAAAAAAAAAAAAAAAAAAAJ/f38AAAAAA8zMzADAwP8Af39/AAAAAAAAAAAAAAAAAAAAAAAAAAAAIQAAABgAAAAUAAAA5wQAAMMPAACROAAAfyQAABAAAAAmAAAACAAAAD2wAAAAAAAA"/>
+                <pr:smNativeData xmlns:pr="smNativeData" xmlns="smNativeData" val="SMDATA_15_FUV5ZhMAAAAlAAAAZAAAAA0AAAAAkAAAAJAAAACQAAAAkAAAAAAAAAAAAAAAAAAAAAEAAABQAAAAAAAAAAAA4D8AAAAAAADgPwAAAAAAAOA/AAAAAAAA4D8AAAAAAADgPwAAAAAAAOA/AAAAAAAA4D8AAAAAAADgPwAAAAAAAOA/AAAAAAAA4D8CAAAAjAAAAAAAAAAAAAAAQoX0DP///wgAAAAAAAAAAAAAAAAAAAAAAAAAAAAAAAAAAAAAZAAAAAEAAABAAAAAAAAAAAAAAAAAAAAAAAAAAAAAAAAAAAAAAAAAAAAAAAAAAAAAAAAAAAAAAAAAAAAAAAAAAAAAAAAAAAAAAAAAAAAAAAAAAAAAAAAAAAAAAAAAAAAAFAAAADwAAAAAAAAAAAAAAAAAAAkUAAAAAQAAABQAAAAUAAAAFAAAAAEAAAAAAAAAZAAAAGQAAAAAAAAAZAAAAGQAAAAVAAAAYAAAAAAAAAAAAAAADwAAACADAAAAAAAAAAAAAAEAAACgMgAAVgcAAKr4//8BAAAAf39/AAEAAABkAAAAAAAAABQAAABAHwAAAAAAACYAAAAAAAAAwOD//wAAAAAmAAAAZAAAABYAAABMAAAAAAAAAAAAAAAEAAAAAAAAAAEAAABZWVkKAAAAACgAAAAoAAAAZAAAAGQAAAAAAAAAzMzMAAAAAABQAAAAUAAAAGQAAABkAAAAAAAAABcAAAAUAAAAAAAAAAAAAAD/fwAA/38AAAAAAAAJAAAABAAAAAAAAAAeAAAAaAAAAAAAAAAAAAAAAAAAAAAAAAAAAAAAECcAABAnAAAAAAAAAAAAAAAAAAAAAAAAAAAAAAAAAAAAAAAAAAAAABQAAAAAAAAAwMD/AAAAAABkAAAAMgAAAAAAAABkAAAAAAAAAH9/fwAKAAAAIgAAABgAAAAAAAAAAAAAAAAAAAAAAAAAAAAAAAAAAAAkAAAAJAAAAAAAAAAHAAAAAAAAAAAAAAAAAAAAAAAAAAAAAAAAAAAAf39/ACUAAABYAAAAAAAAAAAAAAAAAAAAAAAAAAAAAAAAAAAAAAAAAAAAAAAAAAAAAAAAAAAAAAA/AAAAAAAAAKCGAQAAAAAAAAAAAAAAAAAMAAAAAQAAAAAAAAAAAAAAAAAAAB8AAABUAAAAAAAABQAAAAEAAAAAAAAAAAAAAAAAAAAAAAAAAAAAAAAAAAAAAAAAAAAAAAJ/f38AAAAAA8zMzADAwP8Af39/AAAAAAAAAAAAAAAAAAAAAAAAAAAAIQAAABgAAAAUAAAA5wQAAMMPAACROAAAfyQAABAAAAAmAAAACAAAAD2wAAAAAAAA"/>
               </a:ext>
             </a:extLst>
           </p:cNvSpPr>
@@ -2410,7 +2410,7 @@
             <a:spLocks noGrp="1" noChangeArrowheads="1"/>
             <a:extLst>
               <a:ext uri="smNativeData">
-                <pr:smNativeData xmlns:pr="smNativeData" xmlns="smNativeData" val="SMDATA_15_LkR5ZhMAAAAlAAAAZAAAAA0AAAAAkAAAAJAAAACQAAAAkAAAAAAAAAAAAAAAAAAAAAEAAABQAAAAAAAAAAAA4D8AAAAAAADgPwAAAAAAAOA/AAAAAAAA4D8AAAAAAADgPwAAAAAAAOA/AAAAAAAA4D8AAAAAAADgPwAAAAAAAOA/AAAAAAAA4D8CAAAAjAAAAAAAAAAAAAAAQoX0DP///wgAAAAAAAAAAAAAAAAAAAAAAAAAAAAAAAAAAAAAZAAAAAEAAABAAAAAAAAAAAAAAAAAAAAAAAAAAAAAAAAAAAAAAAAAAAAAAAAAAAAAAAAAAAAAAAAAAAAAAAAAAAAAAAAAAAAAAAAAAAAAAAAAAAAAAAAAAAAAAAAAAAAAFAAAADwAAAAAAAAAAAAAAAAAAAkUAAAAAQAAABQAAAAUAAAAFAAAAAEAAAAAAAAAZAAAAGQAAAAAAAAAZAAAAGQAAAAVAAAAYAAAAAAAAAAAAAAADwAAACADAAAAAAAAAAAAAAEAAACgMgAAVgcAAKr4//8BAAAAf39/AAEAAABkAAAAAAAAABQAAABAHwAAAAAAACYAAAAAAAAAwOD//wAAAAAmAAAAZAAAABYAAABMAAAAAAAAAAAAAAAEAAAAAAAAAAEAAABZWVkKAAAAACgAAAAoAAAAZAAAAGQAAAAAAAAAzMzMAAAAAABQAAAAUAAAAGQAAABkAAAAAAAAABcAAAAUAAAAAAAAAAAAAAD/fwAA/38AAAAAAAAJAAAABAAAAAAAAAAeAAAAaAAAAAAAAAAAAAAAAAAAAAAAAAAAAAAAECcAABAnAAAAAAAAAAAAAAAAAAAAAAAAAAAAAAAAAAAAAAAAAAAAABQAAAAAAAAAwMD/AAAAAABkAAAAMgAAAAAAAABkAAAAAAAAAH9/fwAKAAAAIgAAABgAAAAAAAAAAAAAAAAAAAAAAAAAAAAAAAAAAAAkAAAAJAAAAAAAAAAHAAAAAAAAAAAAAAAAAAAAAAAAAAAAAAAAAAAAf39/ACUAAABYAAAAAAAAAAAAAAAAAAAAAAAAAAAAAAAAAAAAAAAAAAAAAAAAAAAAAAAAAAAAAAA/AAAAAAAAAKCGAQAAAAAAAAAAAAAAAAAMAAAAAQAAAAAAAAAAAAAAAAAAAB8AAABUAAAAAAAABQAAAAEAAAAAAAAAAAAAAAAAAAAAAAAAAAAAAAAAAAAAAAAAAAAAAAJ/f38AAAAAA8zMzADAwP8Af39/AAAAAAAAAAAAAAAAAAAAAAAAAAAAIQAAABgAAAAUAAAAFAMAALYCAAB/NwAAvwoAABAAAAAmAAAACAAAADywAAAAAAAA"/>
+                <pr:smNativeData xmlns:pr="smNativeData" xmlns="smNativeData" val="SMDATA_15_FUV5ZhMAAAAlAAAAZAAAAA0AAAAAkAAAAJAAAACQAAAAkAAAAAAAAAAAAAAAAAAAAAEAAABQAAAAAAAAAAAA4D8AAAAAAADgPwAAAAAAAOA/AAAAAAAA4D8AAAAAAADgPwAAAAAAAOA/AAAAAAAA4D8AAAAAAADgPwAAAAAAAOA/AAAAAAAA4D8CAAAAjAAAAAAAAAAAAAAAQoX0DP///wgAAAAAAAAAAAAAAAAAAAAAAAAAAAAAAAAAAAAAZAAAAAEAAABAAAAAAAAAAAAAAAAAAAAAAAAAAAAAAAAAAAAAAAAAAAAAAAAAAAAAAAAAAAAAAAAAAAAAAAAAAAAAAAAAAAAAAAAAAAAAAAAAAAAAAAAAAAAAAAAAAAAAFAAAADwAAAAAAAAAAAAAAAAAAAkUAAAAAQAAABQAAAAUAAAAFAAAAAEAAAAAAAAAZAAAAGQAAAAAAAAAZAAAAGQAAAAVAAAAYAAAAAAAAAAAAAAADwAAACADAAAAAAAAAAAAAAEAAACgMgAAVgcAAKr4//8BAAAAf39/AAEAAABkAAAAAAAAABQAAABAHwAAAAAAACYAAAAAAAAAwOD//wAAAAAmAAAAZAAAABYAAABMAAAAAAAAAAAAAAAEAAAAAAAAAAEAAABZWVkKAAAAACgAAAAoAAAAZAAAAGQAAAAAAAAAzMzMAAAAAABQAAAAUAAAAGQAAABkAAAAAAAAABcAAAAUAAAAAAAAAAAAAAD/fwAA/38AAAAAAAAJAAAABAAAAAAAAAAeAAAAaAAAAAAAAAAAAAAAAAAAAAAAAAAAAAAAECcAABAnAAAAAAAAAAAAAAAAAAAAAAAAAAAAAAAAAAAAAAAAAAAAABQAAAAAAAAAwMD/AAAAAABkAAAAMgAAAAAAAABkAAAAAAAAAH9/fwAKAAAAIgAAABgAAAAAAAAAAAAAAAAAAAAAAAAAAAAAAAAAAAAkAAAAJAAAAAAAAAAHAAAAAAAAAAAAAAAAAAAAAAAAAAAAAAAAAAAAf39/ACUAAABYAAAAAAAAAAAAAAAAAAAAAAAAAAAAAAAAAAAAAAAAAAAAAAAAAAAAAAAAAAAAAAA/AAAAAAAAAKCGAQAAAAAAAAAAAAAAAAAMAAAAAQAAAAAAAAAAAAAAAAAAAB8AAABUAAAAAAAABQAAAAEAAAAAAAAAAAAAAAAAAAAAAAAAAAAAAAAAAAAAAAAAAAAAAAJ/f38AAAAAA8zMzADAwP8Af39/AAAAAAAAAAAAAAAAAAAAAAAAAAAAIQAAABgAAAAUAAAAFAMAALYCAAB/NwAAvwoAABAAAAAmAAAACAAAADywAAAAAAAA"/>
               </a:ext>
             </a:extLst>
           </p:cNvSpPr>
@@ -2545,7 +2545,7 @@
             <a:spLocks noGrp="1" noChangeArrowheads="1"/>
             <a:extLst>
               <a:ext uri="smNativeData">
-                <pr:smNativeData xmlns:pr="smNativeData" xmlns="smNativeData" val="SMDATA_15_LkR5ZhMAAAAlAAAAZAAAAA0AAAAAkAAAAJAAAACQAAAAkAAAAAAAAAAAAAAAAAAAAAEAAABQAAAAAAAAAAAA4D8AAAAAAADgPwAAAAAAAOA/AAAAAAAA4D8AAAAAAADgPwAAAAAAAOA/AAAAAAAA4D8AAAAAAADgPwAAAAAAAOA/AAAAAAAA4D8CAAAAjAAAAAAAAAAAAAAAQoX0DP///wgAAAAAAAAAAAAAAAAAAAAAAAAAAAAAAAAAAAAAZAAAAAEAAABAAAAAAAAAAAAAAAAAAAAAAAAAAAAAAAAAAAAAAAAAAAAAAAAAAAAAAAAAAAAAAAAAAAAAAAAAAAAAAAAAAAAAAAAAAAAAAAAAAAAAAAAAAAAAAAAAAAAAFAAAADwAAAAAAAAAAAAAAAAAAAkUAAAAAQAAABQAAAAUAAAAFAAAAAEAAAAAAAAAZAAAAGQAAAAAAAAAZAAAAGQAAAAVAAAAYAAAAAAAAAAAAAAADwAAACADAAAAAAAAAAAAAAEAAACgMgAAVgcAAKr4//8BAAAAf39/AAEAAABkAAAAAAAAABQAAABAHwAAAAAAACYAAAAAAAAAwOD//wAAAAAmAAAAZAAAABYAAABMAAAAAAAAAAAAAAAEAAAAAAAAAAEAAABZWVkKAAAAACgAAAAoAAAAZAAAAGQAAAAAAAAAzMzMAAAAAABQAAAAUAAAAGQAAABkAAAAAAAAABcAAAAUAAAAAAAAAAAAAAD/fwAA/38AAAAAAAAJAAAABAAAAAAAAAAeAAAAaAAAAAAAAAAAAAAAAAAAAAAAAAAAAAAAECcAABAnAAAAAAAAAAAAAAAAAAAAAAAAAAAAAAAAAAAAAAAAAAAAABQAAAAAAAAAwMD/AAAAAABkAAAAMgAAAAAAAABkAAAAAAAAAH9/fwAKAAAAIgAAABgAAAAAAAAAAAAAAAAAAAAAAAAAAAAAAAAAAAAkAAAAJAAAAAAAAAAHAAAAAAAAAAAAAAAAAAAAAAAAAAAAAAAAAAAAf39/ACUAAABYAAAAAAAAAAAAAAAAAAAAAAAAAAAAAAAAAAAAAAAAAAAAAAAAAAAAAAAAAAAAAAA/AAAAAAAAAKCGAQAAAAAAAAAAAAAAAAAMAAAAAQAAAAAAAAAAAAAAAAAAAB8AAABUAAAAAAAABQAAAAEAAAAAAAAAAAAAAAAAAAAAAAAAAAAAAAAAAAAAAAAAAAAAAAJ/f38AAAAAA8zMzADAwP8Af39/AAAAAAAAAAAAAAAAAAAAAAAAAAAAIQAAABgAAAAUAAAAFAMAALYCAAB/NwAAvwoAABAAAAAmAAAACAAAADywAAAAAAAA"/>
+                <pr:smNativeData xmlns:pr="smNativeData" xmlns="smNativeData" val="SMDATA_15_FUV5ZhMAAAAlAAAAZAAAAA0AAAAAkAAAAJAAAACQAAAAkAAAAAAAAAAAAAAAAAAAAAEAAABQAAAAAAAAAAAA4D8AAAAAAADgPwAAAAAAAOA/AAAAAAAA4D8AAAAAAADgPwAAAAAAAOA/AAAAAAAA4D8AAAAAAADgPwAAAAAAAOA/AAAAAAAA4D8CAAAAjAAAAAAAAAAAAAAAQoX0DP///wgAAAAAAAAAAAAAAAAAAAAAAAAAAAAAAAAAAAAAZAAAAAEAAABAAAAAAAAAAAAAAAAAAAAAAAAAAAAAAAAAAAAAAAAAAAAAAAAAAAAAAAAAAAAAAAAAAAAAAAAAAAAAAAAAAAAAAAAAAAAAAAAAAAAAAAAAAAAAAAAAAAAAFAAAADwAAAAAAAAAAAAAAAAAAAkUAAAAAQAAABQAAAAUAAAAFAAAAAEAAAAAAAAAZAAAAGQAAAAAAAAAZAAAAGQAAAAVAAAAYAAAAAAAAAAAAAAADwAAACADAAAAAAAAAAAAAAEAAACgMgAAVgcAAKr4//8BAAAAf39/AAEAAABkAAAAAAAAABQAAABAHwAAAAAAACYAAAAAAAAAwOD//wAAAAAmAAAAZAAAABYAAABMAAAAAAAAAAAAAAAEAAAAAAAAAAEAAABZWVkKAAAAACgAAAAoAAAAZAAAAGQAAAAAAAAAzMzMAAAAAABQAAAAUAAAAGQAAABkAAAAAAAAABcAAAAUAAAAAAAAAAAAAAD/fwAA/38AAAAAAAAJAAAABAAAAAAAAAAeAAAAaAAAAAAAAAAAAAAAAAAAAAAAAAAAAAAAECcAABAnAAAAAAAAAAAAAAAAAAAAAAAAAAAAAAAAAAAAAAAAAAAAABQAAAAAAAAAwMD/AAAAAABkAAAAMgAAAAAAAABkAAAAAAAAAH9/fwAKAAAAIgAAABgAAAAAAAAAAAAAAAAAAAAAAAAAAAAAAAAAAAAkAAAAJAAAAAAAAAAHAAAAAAAAAAAAAAAAAAAAAAAAAAAAAAAAAAAAf39/ACUAAABYAAAAAAAAAAAAAAAAAAAAAAAAAAAAAAAAAAAAAAAAAAAAAAAAAAAAAAAAAAAAAAA/AAAAAAAAAKCGAQAAAAAAAAAAAAAAAAAMAAAAAQAAAAAAAAAAAAAAAAAAAB8AAABUAAAAAAAABQAAAAEAAAAAAAAAAAAAAAAAAAAAAAAAAAAAAAAAAAAAAAAAAAAAAAJ/f38AAAAAA8zMzADAwP8Af39/AAAAAAAAAAAAAAAAAAAAAAAAAAAAIQAAABgAAAAUAAAAFAMAALYCAAB/NwAAvwoAABAAAAAmAAAACAAAADywAAAAAAAA"/>
               </a:ext>
             </a:extLst>
           </p:cNvSpPr>
@@ -2654,7 +2654,7 @@
           <p:cNvSpPr>
             <a:extLst>
               <a:ext uri="smNativeData">
-                <pr:smNativeData xmlns:pr="smNativeData" xmlns="smNativeData" val="SMDATA_15_LkR5ZhMAAAAlAAAAZAAAAA0AAAAAkAAAAJAAAACQAAAAkAAAAAAAAAABAAAAAAAAAAEAAABQAAAAAAAAAAAA4D8AAAAAAADgPwAAAAAAAOA/AAAAAAAA4D8AAAAAAADgPwAAAAAAAOA/AAAAAAAA4D8AAAAAAADgPwAAAAAAAOA/AAAAAAAA4D8CAAAAjAAAAAEAAAAAAAAA+/v+AP///wgAAAAAAAAAAAAAAAAAAAAAAAAAAAAAAAAAAAAAeAAAAAEAAABAAAAAAAAAAAAAAABaAAAAAAAAAAAAAAAAAAAAAAAAAAAAAAAAAAAAAAAAAAAAAAAAAAAAAAAAAAAAAAAAAAAAAAAAAAAAAAAAAAAAAAAAAAAAAAAAAAAAFAAAADwAAAAAAAAAAAAAAAAAAAkUAAAAAQAAABQAAAAUAAAAFAAAAAEAAAAAAAAAZAAAAGQAAAAAAAAAZAAAAGQAAAAVAAAAYAAAAAAAAAAAAAAADwAAACADAAAAAAAAAAAAAAEAAACgMgAAVgcAAKr4//8BAAAAf39/AAEAAABkAAAAAAAAABQAAABAHwAAAAAAACYAAAAAAAAAwOD//wAAAAAmAAAAZAAAABYAAABMAAAAAAAAAAAAAAAEAAAAAAAAAAEAAABZWVkKAAAAACgAAAAoAAAAZAAAAGQAAAAAAAAAzMzMAAAAAABQAAAAUAAAAGQAAABkAAAAAAAAABcAAAAUAAAAAAAAAAAAAAD/fwAA/38AAAAAAAAJAAAABAAAAAAAAAAeAAAAaAAAAAAAAAAAAAAAAAAAAAAAAAAAAAAAECcAABAnAAAAAAAAAAAAAAAAAAAAAAAAAAAAAAAAAAAAAAAAAAAAABQAAAAAAAAAwMD/AAAAAABkAAAAMgAAAAAAAABkAAAAAAAAAH9/fwAKAAAAIgAAABgAAAAAAAAAAAAAAAAAAAAAAAAAAAAAAAAAAAAkAAAAJAAAAAAAAAAHAAAAAAAAAAAAAAAAAAAAAAAAAAAAAAAAAAAAf39/ACUAAABYAAAAAAAAAAAAAAAAAAAAAAAAAAAAAAAAAAAAAAAAAAAAAAAAAAAAAAAAAAAAAAA/AAAAAAAAAKCGAQAAAAAAAAAAAAAAAAAMAAAAAQAAAAAAAAAAAAAAAAAAAB8AAABUAAAA+/v+AP///wEAAAAAAAAAAAAAAAAAAAAAAAAAAAAAAAAAAAAAAAAAAAAAAAJ/f38AWVlZA8zMzADAwP8Af39/AAAAAAAAAAAAAAAAAAAAAAAAAAAAIQAAABgAAAAUAAAAuwMAAPIJAACQNAAALycAABAAAAAmAAAACAAAAP//////////"/>
+                <pr:smNativeData xmlns:pr="smNativeData" xmlns="smNativeData" val="SMDATA_15_FUV5ZhMAAAAlAAAAZAAAAA0AAAAAkAAAAJAAAACQAAAAkAAAAAAAAAABAAAAAAAAAAEAAABQAAAAAAAAAAAA4D8AAAAAAADgPwAAAAAAAOA/AAAAAAAA4D8AAAAAAADgPwAAAAAAAOA/AAAAAAAA4D8AAAAAAADgPwAAAAAAAOA/AAAAAAAA4D8CAAAAjAAAAAEAAAAAAAAA+/v+AP///wgAAAAAAAAAAAAAAAAAAAAAAAAAAAAAAAAAAAAAeAAAAAEAAABAAAAAAAAAAAAAAABaAAAAAAAAAAAAAAAAAAAAAAAAAAAAAAAAAAAAAAAAAAAAAAAAAAAAAAAAAAAAAAAAAAAAAAAAAAAAAAAAAAAAAAAAAAAAAAAAAAAAFAAAADwAAAAAAAAAAAAAAAAAAAkUAAAAAQAAABQAAAAUAAAAFAAAAAEAAAAAAAAAZAAAAGQAAAAAAAAAZAAAAGQAAAAVAAAAYAAAAAAAAAAAAAAADwAAACADAAAAAAAAAAAAAAEAAACgMgAAVgcAAKr4//8BAAAAf39/AAEAAABkAAAAAAAAABQAAABAHwAAAAAAACYAAAAAAAAAwOD//wAAAAAmAAAAZAAAABYAAABMAAAAAAAAAAAAAAAEAAAAAAAAAAEAAABZWVkKAAAAACgAAAAoAAAAZAAAAGQAAAAAAAAAzMzMAAAAAABQAAAAUAAAAGQAAABkAAAAAAAAABcAAAAUAAAAAAAAAAAAAAD/fwAA/38AAAAAAAAJAAAABAAAAAAAAAAeAAAAaAAAAAAAAAAAAAAAAAAAAAAAAAAAAAAAECcAABAnAAAAAAAAAAAAAAAAAAAAAAAAAAAAAAAAAAAAAAAAAAAAABQAAAAAAAAAwMD/AAAAAABkAAAAMgAAAAAAAABkAAAAAAAAAH9/fwAKAAAAIgAAABgAAAAAAAAAAAAAAAAAAAAAAAAAAAAAAAAAAAAkAAAAJAAAAAAAAAAHAAAAAAAAAAAAAAAAAAAAAAAAAAAAAAAAAAAAf39/ACUAAABYAAAAAAAAAAAAAAAAAAAAAAAAAAAAAAAAAAAAAAAAAAAAAAAAAAAAAAAAAAAAAAA/AAAAAAAAAKCGAQAAAAAAAAAAAAAAAAAMAAAAAQAAAAAAAAAAAAAAAAAAAB8AAABUAAAA+/v+AP///wEAAAAAAAAAAAAAAAAAAAAAAAAAAAAAAAAAAAAAAAAAAAAAAAJ/f38AWVlZA8zMzADAwP8Af39/AAAAAAAAAAAAAAAAAAAAAAAAAAAAIQAAABgAAAAUAAAAuwMAAPIJAACQNAAALycAABAAAAAmAAAACAAAAP//////////"/>
               </a:ext>
             </a:extLst>
           </p:cNvSpPr>
@@ -2699,7 +2699,7 @@
             <a:spLocks noGrp="1" noChangeArrowheads="1"/>
             <a:extLst>
               <a:ext uri="smNativeData">
-                <pr:smNativeData xmlns:pr="smNativeData" xmlns="smNativeData" val="SMDATA_15_LkR5ZhMAAAAlAAAAZAAAAA0AAAAAkAAAAJAAAACQAAAAkAAAAAAAAAAAAAAAAAAAAAEAAABQAAAAAAAAAAAA4D8AAAAAAADgPwAAAAAAAOA/AAAAAAAA4D8AAAAAAADgPwAAAAAAAOA/AAAAAAAA4D8AAAAAAADgPwAAAAAAAOA/AAAAAAAA4D8CAAAAjAAAAAAAAAAAAAAAQoX0DP///wgAAAAAAAAAAAAAAAAAAAAAAAAAAAAAAAAAAAAAZAAAAAEAAABAAAAAAAAAAAAAAAAAAAAAAAAAAAAAAAAAAAAAAAAAAAAAAAAAAAAAAAAAAAAAAAAAAAAAAAAAAAAAAAAAAAAAAAAAAAAAAAAAAAAAAAAAAAAAAAAAAAAAFAAAADwAAAAAAAAAAAAAAAAAAAkUAAAAAQAAABQAAAAUAAAAFAAAAAEAAAAAAAAAZAAAAGQAAAAAAAAAZAAAAGQAAAAVAAAAYAAAAAAAAAAAAAAADwAAACADAAAAAAAAAAAAAAEAAACgMgAAVgcAAKr4//8BAAAAf39/AAEAAABkAAAAAAAAABQAAABAHwAAAAAAACYAAAAAAAAAwOD//wAAAAAmAAAAZAAAABYAAABMAAAAAAAAAAAAAAAEAAAAAAAAAAEAAABZWVkKAAAAACgAAAAoAAAAZAAAAGQAAAAAAAAAzMzMAAAAAABQAAAAUAAAAGQAAABkAAAAAAAAABcAAAAUAAAAAAAAAAAAAAD/fwAA/38AAAAAAAAJAAAABAAAAAAAAAAeAAAAaAAAAAAAAAAAAAAAAAAAAAAAAAAAAAAAECcAABAnAAAAAAAAAAAAAAAAAAAAAAAAAAAAAAAAAAAAAAAAAAAAABQAAAAAAAAAwMD/AAAAAABkAAAAMgAAAAAAAABkAAAAAAAAAH9/fwAKAAAAIgAAABgAAAAAAAAAAAAAAAAAAAAAAAAAAAAAAAAAAAAkAAAAJAAAAAAAAAAHAAAAAAAAAAAAAAAAAAAAAAAAAAAAAAAAAAAAf39/ACUAAABYAAAAAAAAAAAAAAAAAAAAAAAAAAAAAAAAAAAAAAAAAAAAAAAAAAAAAAAAAAAAAAA/AAAAAAAAAKCGAQAAAAAAAAAAAAAAAAAMAAAAAQAAAAAAAAAAAAAAAAAAAB8AAABUAAAAAAAABQAAAAEAAAAAAAAAAAAAAAAAAAAAAAAAAAAAAAAAAAAAAAAAAAAAAAJ/f38AAAAAA8zMzADAwP8Af39/AAAAAAAAAAAAAAAAAAAAAAAAAAAAIQAAABgAAAAUAAAAfAQAANkKAAC5NQAAMCcAABAAAAAmAAAACAAAAD2wAAAAAAAA"/>
+                <pr:smNativeData xmlns:pr="smNativeData" xmlns="smNativeData" val="SMDATA_15_FUV5ZhMAAAAlAAAAZAAAAA0AAAAAkAAAAJAAAACQAAAAkAAAAAAAAAAAAAAAAAAAAAEAAABQAAAAAAAAAAAA4D8AAAAAAADgPwAAAAAAAOA/AAAAAAAA4D8AAAAAAADgPwAAAAAAAOA/AAAAAAAA4D8AAAAAAADgPwAAAAAAAOA/AAAAAAAA4D8CAAAAjAAAAAAAAAAAAAAAQoX0DP///wgAAAAAAAAAAAAAAAAAAAAAAAAAAAAAAAAAAAAAZAAAAAEAAABAAAAAAAAAAAAAAAAAAAAAAAAAAAAAAAAAAAAAAAAAAAAAAAAAAAAAAAAAAAAAAAAAAAAAAAAAAAAAAAAAAAAAAAAAAAAAAAAAAAAAAAAAAAAAAAAAAAAAFAAAADwAAAAAAAAAAAAAAAAAAAkUAAAAAQAAABQAAAAUAAAAFAAAAAEAAAAAAAAAZAAAAGQAAAAAAAAAZAAAAGQAAAAVAAAAYAAAAAAAAAAAAAAADwAAACADAAAAAAAAAAAAAAEAAACgMgAAVgcAAKr4//8BAAAAf39/AAEAAABkAAAAAAAAABQAAABAHwAAAAAAACYAAAAAAAAAwOD//wAAAAAmAAAAZAAAABYAAABMAAAAAAAAAAAAAAAEAAAAAAAAAAEAAABZWVkKAAAAACgAAAAoAAAAZAAAAGQAAAAAAAAAzMzMAAAAAABQAAAAUAAAAGQAAABkAAAAAAAAABcAAAAUAAAAAAAAAAAAAAD/fwAA/38AAAAAAAAJAAAABAAAAAAAAAAeAAAAaAAAAAAAAAAAAAAAAAAAAAAAAAAAAAAAECcAABAnAAAAAAAAAAAAAAAAAAAAAAAAAAAAAAAAAAAAAAAAAAAAABQAAAAAAAAAwMD/AAAAAABkAAAAMgAAAAAAAABkAAAAAAAAAH9/fwAKAAAAIgAAABgAAAAAAAAAAAAAAAAAAAAAAAAAAAAAAAAAAAAkAAAAJAAAAAAAAAAHAAAAAAAAAAAAAAAAAAAAAAAAAAAAAAAAAAAAf39/ACUAAABYAAAAAAAAAAAAAAAAAAAAAAAAAAAAAAAAAAAAAAAAAAAAAAAAAAAAAAAAAAAAAAA/AAAAAAAAAKCGAQAAAAAAAAAAAAAAAAAMAAAAAQAAAAAAAAAAAAAAAAAAAB8AAABUAAAAAAAABQAAAAEAAAAAAAAAAAAAAAAAAAAAAAAAAAAAAAAAAAAAAAAAAAAAAAJ/f38AAAAAA8zMzADAwP8Af39/AAAAAAAAAAAAAAAAAAAAAAAAAAAAIQAAABgAAAAUAAAAfAQAANkKAAC5NQAAMCcAABAAAAAmAAAACAAAAD2wAAAAAAAA"/>
               </a:ext>
             </a:extLst>
           </p:cNvSpPr>
@@ -2879,7 +2879,7 @@
             <a:spLocks noGrp="1" noChangeArrowheads="1"/>
             <a:extLst>
               <a:ext uri="smNativeData">
-                <pr:smNativeData xmlns:pr="smNativeData" xmlns="smNativeData" val="SMDATA_15_LkR5ZhMAAAAlAAAAZAAAAA0AAAAAkAAAAJAAAACQAAAAkAAAAAAAAAAAAAAAAAAAAAEAAABQAAAAAAAAAAAA4D8AAAAAAADgPwAAAAAAAOA/AAAAAAAA4D8AAAAAAADgPwAAAAAAAOA/AAAAAAAA4D8AAAAAAADgPwAAAAAAAOA/AAAAAAAA4D8CAAAAjAAAAAAAAAAAAAAAQoX0DP///wgAAAAAAAAAAAAAAAAAAAAAAAAAAAAAAAAAAAAAZAAAAAEAAABAAAAAAAAAAAAAAAAAAAAAAAAAAAAAAAAAAAAAAAAAAAAAAAAAAAAAAAAAAAAAAAAAAAAAAAAAAAAAAAAAAAAAAAAAAAAAAAAAAAAAAAAAAAAAAAAAAAAAFAAAADwAAAAAAAAAAAAAAAAAAAkUAAAAAQAAABQAAAAUAAAAFAAAAAEAAAAAAAAAZAAAAGQAAAAAAAAAZAAAAGQAAAAVAAAAYAAAAAAAAAAAAAAADwAAACADAAAAAAAAAAAAAAEAAACgMgAAVgcAAKr4//8BAAAAf39/AAEAAABkAAAAAAAAABQAAABAHwAAAAAAACYAAAAAAAAAwOD//wAAAAAmAAAAZAAAABYAAABMAAAAAAAAAAAAAAAEAAAAAAAAAAEAAABZWVkKAAAAACgAAAAoAAAAZAAAAGQAAAAAAAAAzMzMAAAAAABQAAAAUAAAAGQAAABkAAAAAAAAABcAAAAUAAAAAAAAAAAAAAD/fwAA/38AAAAAAAAJAAAABAAAAAAAAAAeAAAAaAAAAAAAAAAAAAAAAAAAAAAAAAAAAAAAECcAABAnAAAAAAAAAAAAAAAAAAAAAAAAAAAAAAAAAAAAAAAAAAAAABQAAAAAAAAAwMD/AAAAAABkAAAAMgAAAAAAAABkAAAAAAAAAH9/fwAKAAAAIgAAABgAAAAAAAAAAAAAAAAAAAAAAAAAAAAAAAAAAAAkAAAAJAAAAAAAAAAHAAAAAAAAAAAAAAAAAAAAAAAAAAAAAAAAAAAAf39/ACUAAABYAAAAAAAAAAAAAAAAAAAAAAAAAAAAAAAAAAAAAAAAAAAAAAAAAAAAAAAAAAAAAAA/AAAAAAAAAKCGAQAAAAAAAAAAAAAAAAAMAAAAAQAAAAAAAAAAAAAAAAAAAB8AAABUAAAAAAAABQAAAAEAAAAAAAAAAAAAAAAAAAAAAAAAAAAAAAAAAAAAAAAAAAAAAAJ/f38AAAAAA8zMzADAwP8Af39/AAAAAAAAAAAAAAAAAAAAAAAAAAAAIQAAABgAAAAUAAAAFAMAALYCAAB/NwAAvwoAABAAAAAmAAAACAAAADywAAAAAAAA"/>
+                <pr:smNativeData xmlns:pr="smNativeData" xmlns="smNativeData" val="SMDATA_15_FUV5ZhMAAAAlAAAAZAAAAA0AAAAAkAAAAJAAAACQAAAAkAAAAAAAAAAAAAAAAAAAAAEAAABQAAAAAAAAAAAA4D8AAAAAAADgPwAAAAAAAOA/AAAAAAAA4D8AAAAAAADgPwAAAAAAAOA/AAAAAAAA4D8AAAAAAADgPwAAAAAAAOA/AAAAAAAA4D8CAAAAjAAAAAAAAAAAAAAAQoX0DP///wgAAAAAAAAAAAAAAAAAAAAAAAAAAAAAAAAAAAAAZAAAAAEAAABAAAAAAAAAAAAAAAAAAAAAAAAAAAAAAAAAAAAAAAAAAAAAAAAAAAAAAAAAAAAAAAAAAAAAAAAAAAAAAAAAAAAAAAAAAAAAAAAAAAAAAAAAAAAAAAAAAAAAFAAAADwAAAAAAAAAAAAAAAAAAAkUAAAAAQAAABQAAAAUAAAAFAAAAAEAAAAAAAAAZAAAAGQAAAAAAAAAZAAAAGQAAAAVAAAAYAAAAAAAAAAAAAAADwAAACADAAAAAAAAAAAAAAEAAACgMgAAVgcAAKr4//8BAAAAf39/AAEAAABkAAAAAAAAABQAAABAHwAAAAAAACYAAAAAAAAAwOD//wAAAAAmAAAAZAAAABYAAABMAAAAAAAAAAAAAAAEAAAAAAAAAAEAAABZWVkKAAAAACgAAAAoAAAAZAAAAGQAAAAAAAAAzMzMAAAAAABQAAAAUAAAAGQAAABkAAAAAAAAABcAAAAUAAAAAAAAAAAAAAD/fwAA/38AAAAAAAAJAAAABAAAAAAAAAAeAAAAaAAAAAAAAAAAAAAAAAAAAAAAAAAAAAAAECcAABAnAAAAAAAAAAAAAAAAAAAAAAAAAAAAAAAAAAAAAAAAAAAAABQAAAAAAAAAwMD/AAAAAABkAAAAMgAAAAAAAABkAAAAAAAAAH9/fwAKAAAAIgAAABgAAAAAAAAAAAAAAAAAAAAAAAAAAAAAAAAAAAAkAAAAJAAAAAAAAAAHAAAAAAAAAAAAAAAAAAAAAAAAAAAAAAAAAAAAf39/ACUAAABYAAAAAAAAAAAAAAAAAAAAAAAAAAAAAAAAAAAAAAAAAAAAAAAAAAAAAAAAAAAAAAA/AAAAAAAAAKCGAQAAAAAAAAAAAAAAAAAMAAAAAQAAAAAAAAAAAAAAAAAAAB8AAABUAAAAAAAABQAAAAEAAAAAAAAAAAAAAAAAAAAAAAAAAAAAAAAAAAAAAAAAAAAAAAJ/f38AAAAAA8zMzADAwP8Af39/AAAAAAAAAAAAAAAAAAAAAAAAAAAAIQAAABgAAAAUAAAAFAMAALYCAAB/NwAAvwoAABAAAAAmAAAACAAAADywAAAAAAAA"/>
               </a:ext>
             </a:extLst>
           </p:cNvSpPr>
@@ -2988,7 +2988,7 @@
           <p:cNvSpPr>
             <a:extLst>
               <a:ext uri="smNativeData">
-                <pr:smNativeData xmlns:pr="smNativeData" xmlns="smNativeData" val="SMDATA_15_LkR5ZhMAAAAlAAAAZAAAAA0AAAAAkAAAAJAAAACQAAAAkAAAAAAAAAABAAAAAAAAAAEAAABQAAAAAAAAAAAA4D8AAAAAAADgPwAAAAAAAOA/AAAAAAAA4D8AAAAAAADgPwAAAAAAAOA/AAAAAAAA4D8AAAAAAADgPwAAAAAAAOA/AAAAAAAA4D8CAAAAjAAAAAEAAAAAAAAAISEhDf///wgAAAAAAAAAAAAAAAAAAAAAAAAAAAAAAAAAAAAAeAAAAAEAAABAAAAAAAAAAAAAAABaAAAAAAAAAAAAAAAAAAAAAAAAAAAAAAAAAAAAAAAAAAAAAAAAAAAAAAAAAAAAAAAAAAAAAAAAAAAAAAAAAAAAAAAAAAAAAAAAAAAAFAAAADwAAAAAAAAAAAAAAAAAAAkUAAAAAQAAABQAAAAUAAAAFAAAAAEAAAAAAAAAZAAAAGQAAAAAAAAAZAAAAGQAAAAVAAAAYAAAAAAAAAAAAAAADwAAACADAAAAAAAAAAAAAAEAAACgMgAAVgcAAKr4//8BAAAAf39/AAEAAABkAAAAAAAAABQAAABAHwAAAAAAACYAAAAAAAAAwOD//wAAAAAmAAAAZAAAABYAAABMAAAAAAAAAAAAAAAEAAAAAAAAAAEAAABZWVkKAAAAACgAAAAoAAAAZAAAAGQAAAAAAAAAzMzMAAAAAABQAAAAUAAAAGQAAABkAAAAAAAAABcAAAAUAAAAAAAAAAAAAAD/fwAA/38AAAAAAAAJAAAABAAAAAAAAAAeAAAAaAAAAAAAAAAAAAAAAAAAAAAAAAAAAAAAECcAABAnAAAAAAAAAAAAAAAAAAAAAAAAAAAAAAAAAAAAAAAAAAAAABQAAAAAAAAAwMD/AAAAAABkAAAAMgAAAAAAAABkAAAAAAAAAH9/fwAKAAAAIgAAABgAAAAAAAAAAAAAAAAAAAAAAAAAAAAAAAAAAAAkAAAAJAAAAAAAAAAHAAAAAAAAAAAAAAAAAAAAAAAAAAAAAAAAAAAAf39/ACUAAABYAAAAAAAAAAAAAAAAAAAAAAAAAAAAAAAAAAAAAAAAAAAAAAAAAAAAAAAAAAAAAAA/AAAAAAAAAKCGAQAAAAAAAAAAAAAAAAAMAAAAAQAAAAAAAAAAAAAAAAAAAB8AAABUAAAAAAAABgAAAAEAAAAAAAAAAAAAAAAAAAAAAAAAAAAAAAAAAAAAAAAAAAAAAAJ/f38AAAAAA8zMzADAwP8Af39/AAAAAAAAAAAAAAAAAAAAAAAAAAAAIQAAABgAAAAUAAAAuwMAAPIJAACQNAAALycAABAAAAAmAAAACAAAAP//////////"/>
+                <pr:smNativeData xmlns:pr="smNativeData" xmlns="smNativeData" val="SMDATA_15_FUV5ZhMAAAAlAAAAZAAAAA0AAAAAkAAAAJAAAACQAAAAkAAAAAAAAAABAAAAAAAAAAEAAABQAAAAAAAAAAAA4D8AAAAAAADgPwAAAAAAAOA/AAAAAAAA4D8AAAAAAADgPwAAAAAAAOA/AAAAAAAA4D8AAAAAAADgPwAAAAAAAOA/AAAAAAAA4D8CAAAAjAAAAAEAAAAAAAAAISEhDf///wgAAAAAAAAAAAAAAAAAAAAAAAAAAAAAAAAAAAAAeAAAAAEAAABAAAAAAAAAAAAAAABaAAAAAAAAAAAAAAAAAAAAAAAAAAAAAAAAAAAAAAAAAAAAAAAAAAAAAAAAAAAAAAAAAAAAAAAAAAAAAAAAAAAAAAAAAAAAAAAAAAAAFAAAADwAAAAAAAAAAAAAAAAAAAkUAAAAAQAAABQAAAAUAAAAFAAAAAEAAAAAAAAAZAAAAGQAAAAAAAAAZAAAAGQAAAAVAAAAYAAAAAAAAAAAAAAADwAAACADAAAAAAAAAAAAAAEAAACgMgAAVgcAAKr4//8BAAAAf39/AAEAAABkAAAAAAAAABQAAABAHwAAAAAAACYAAAAAAAAAwOD//wAAAAAmAAAAZAAAABYAAABMAAAAAAAAAAAAAAAEAAAAAAAAAAEAAABZWVkKAAAAACgAAAAoAAAAZAAAAGQAAAAAAAAAzMzMAAAAAABQAAAAUAAAAGQAAABkAAAAAAAAABcAAAAUAAAAAAAAAAAAAAD/fwAA/38AAAAAAAAJAAAABAAAAAAAAAAeAAAAaAAAAAAAAAAAAAAAAAAAAAAAAAAAAAAAECcAABAnAAAAAAAAAAAAAAAAAAAAAAAAAAAAAAAAAAAAAAAAAAAAABQAAAAAAAAAwMD/AAAAAABkAAAAMgAAAAAAAABkAAAAAAAAAH9/fwAKAAAAIgAAABgAAAAAAAAAAAAAAAAAAAAAAAAAAAAAAAAAAAAkAAAAJAAAAAAAAAAHAAAAAAAAAAAAAAAAAAAAAAAAAAAAAAAAAAAAf39/ACUAAABYAAAAAAAAAAAAAAAAAAAAAAAAAAAAAAAAAAAAAAAAAAAAAAAAAAAAAAAAAAAAAAA/AAAAAAAAAKCGAQAAAAAAAAAAAAAAAAAMAAAAAQAAAAAAAAAAAAAAAAAAAB8AAABUAAAAAAAABgAAAAEAAAAAAAAAAAAAAAAAAAAAAAAAAAAAAAAAAAAAAAAAAAAAAAJ/f38AAAAAA8zMzADAwP8Af39/AAAAAAAAAAAAAAAAAAAAAAAAAAAAIQAAABgAAAAUAAAAuwMAAPIJAACQNAAALycAABAAAAAmAAAACAAAAP//////////"/>
               </a:ext>
             </a:extLst>
           </p:cNvSpPr>
@@ -3033,7 +3033,7 @@
             <a:spLocks noGrp="1" noChangeArrowheads="1"/>
             <a:extLst>
               <a:ext uri="smNativeData">
-                <pr:smNativeData xmlns:pr="smNativeData" xmlns="smNativeData" val="SMDATA_15_LkR5ZhMAAAAlAAAAZAAAAA0AAAAAkAAAAJAAAACQAAAAkAAAAAAAAAAAAAAAAAAAAAEAAABQAAAAAAAAAAAA4D8AAAAAAADgPwAAAAAAAOA/AAAAAAAA4D8AAAAAAADgPwAAAAAAAOA/AAAAAAAA4D8AAAAAAADgPwAAAAAAAOA/AAAAAAAA4D8CAAAAjAAAAAAAAAAAAAAAQoX0DP///wgAAAAAAAAAAAAAAAAAAAAAAAAAAAAAAAAAAAAAZAAAAAEAAABAAAAAAAAAAAAAAAAAAAAAAAAAAAAAAAAAAAAAAAAAAAAAAAAAAAAAAAAAAAAAAAAAAAAAAAAAAAAAAAAAAAAAAAAAAAAAAAAAAAAAAAAAAAAAAAAAAAAAFAAAADwAAAAAAAAAAAAAAAAAAAkUAAAAAQAAABQAAAAUAAAAFAAAAAEAAAAAAAAAZAAAAGQAAAAAAAAAZAAAAGQAAAAVAAAAYAAAAAAAAAAAAAAADwAAACADAAAAAAAAAAAAAAEAAACgMgAAVgcAAKr4//8BAAAAf39/AAEAAABkAAAAAAAAABQAAABAHwAAAAAAACYAAAAAAAAAwOD//wAAAAAmAAAAZAAAABYAAABMAAAAAAAAAAAAAAAEAAAAAAAAAAEAAABZWVkKAAAAACgAAAAoAAAAZAAAAGQAAAAAAAAAzMzMAAAAAABQAAAAUAAAAGQAAABkAAAAAAAAABcAAAAUAAAAAAAAAAAAAAD/fwAA/38AAAAAAAAJAAAABAAAAAAAAAAeAAAAaAAAAAAAAAAAAAAAAAAAAAAAAAAAAAAAECcAABAnAAAAAAAAAAAAAAAAAAAAAAAAAAAAAAAAAAAAAAAAAAAAABQAAAAAAAAAwMD/AAAAAABkAAAAMgAAAAAAAABkAAAAAAAAAH9/fwAKAAAAIgAAABgAAAAAAAAAAAAAAAAAAAAAAAAAAAAAAAAAAAAkAAAAJAAAAAAAAAAHAAAAAAAAAAAAAAAAAAAAAAAAAAAAAAAAAAAAf39/ACUAAABYAAAAAAAAAAAAAAAAAAAAAAAAAAAAAAAAAAAAAAAAAAAAAAAAAAAAAAAAAAAAAAA/AAAAAAAAAKCGAQAAAAAAAAAAAAAAAAAMAAAAAQAAAAAAAAAAAAAAAAAAAB8AAABUAAAAAAAABQAAAAEAAAAAAAAAAAAAAAAAAAAAAAAAAAAAAAAAAAAAAAAAAAAAAAJ/f38AAAAAA8zMzADAwP8Af39/AAAAAAAAAAAAAAAAAAAAAAAAAAAAIQAAABgAAAAUAAAAfAQAANkKAAC5NQAAMCcAABAAAAAmAAAACAAAAD2wAAAAAAAA"/>
+                <pr:smNativeData xmlns:pr="smNativeData" xmlns="smNativeData" val="SMDATA_15_FUV5ZhMAAAAlAAAAZAAAAA0AAAAAkAAAAJAAAACQAAAAkAAAAAAAAAAAAAAAAAAAAAEAAABQAAAAAAAAAAAA4D8AAAAAAADgPwAAAAAAAOA/AAAAAAAA4D8AAAAAAADgPwAAAAAAAOA/AAAAAAAA4D8AAAAAAADgPwAAAAAAAOA/AAAAAAAA4D8CAAAAjAAAAAAAAAAAAAAAQoX0DP///wgAAAAAAAAAAAAAAAAAAAAAAAAAAAAAAAAAAAAAZAAAAAEAAABAAAAAAAAAAAAAAAAAAAAAAAAAAAAAAAAAAAAAAAAAAAAAAAAAAAAAAAAAAAAAAAAAAAAAAAAAAAAAAAAAAAAAAAAAAAAAAAAAAAAAAAAAAAAAAAAAAAAAFAAAADwAAAAAAAAAAAAAAAAAAAkUAAAAAQAAABQAAAAUAAAAFAAAAAEAAAAAAAAAZAAAAGQAAAAAAAAAZAAAAGQAAAAVAAAAYAAAAAAAAAAAAAAADwAAACADAAAAAAAAAAAAAAEAAACgMgAAVgcAAKr4//8BAAAAf39/AAEAAABkAAAAAAAAABQAAABAHwAAAAAAACYAAAAAAAAAwOD//wAAAAAmAAAAZAAAABYAAABMAAAAAAAAAAAAAAAEAAAAAAAAAAEAAABZWVkKAAAAACgAAAAoAAAAZAAAAGQAAAAAAAAAzMzMAAAAAABQAAAAUAAAAGQAAABkAAAAAAAAABcAAAAUAAAAAAAAAAAAAAD/fwAA/38AAAAAAAAJAAAABAAAAAAAAAAeAAAAaAAAAAAAAAAAAAAAAAAAAAAAAAAAAAAAECcAABAnAAAAAAAAAAAAAAAAAAAAAAAAAAAAAAAAAAAAAAAAAAAAABQAAAAAAAAAwMD/AAAAAABkAAAAMgAAAAAAAABkAAAAAAAAAH9/fwAKAAAAIgAAABgAAAAAAAAAAAAAAAAAAAAAAAAAAAAAAAAAAAAkAAAAJAAAAAAAAAAHAAAAAAAAAAAAAAAAAAAAAAAAAAAAAAAAAAAAf39/ACUAAABYAAAAAAAAAAAAAAAAAAAAAAAAAAAAAAAAAAAAAAAAAAAAAAAAAAAAAAAAAAAAAAA/AAAAAAAAAKCGAQAAAAAAAAAAAAAAAAAMAAAAAQAAAAAAAAAAAAAAAAAAAB8AAABUAAAAAAAABQAAAAEAAAAAAAAAAAAAAAAAAAAAAAAAAAAAAAAAAAAAAAAAAAAAAAJ/f38AAAAAA8zMzADAwP8Af39/AAAAAAAAAAAAAAAAAAAAAAAAAAAAIQAAABgAAAAUAAAAfAQAANkKAAC5NQAAMCcAABAAAAAmAAAACAAAAD2wAAAAAAAA"/>
               </a:ext>
             </a:extLst>
           </p:cNvSpPr>
@@ -3248,7 +3248,7 @@
             <a:spLocks noGrp="1" noChangeArrowheads="1"/>
             <a:extLst>
               <a:ext uri="smNativeData">
-                <pr:smNativeData xmlns:pr="smNativeData" xmlns="smNativeData" val="SMDATA_15_LkR5ZhMAAAAlAAAAZAAAAA0AAAAAkAAAAJAAAACQAAAAkAAAAAAAAAAAAAAAAAAAAAEAAABQAAAAAAAAAAAA4D8AAAAAAADgPwAAAAAAAOA/AAAAAAAA4D8AAAAAAADgPwAAAAAAAOA/AAAAAAAA4D8AAAAAAADgPwAAAAAAAOA/AAAAAAAA4D8CAAAAjAAAAAAAAAAAAAAAQoX0DP///wgAAAAAAAAAAAAAAAAAAAAAAAAAAAAAAAAAAAAAZAAAAAEAAABAAAAAAAAAAAAAAAAAAAAAAAAAAAAAAAAAAAAAAAAAAAAAAAAAAAAAAAAAAAAAAAAAAAAAAAAAAAAAAAAAAAAAAAAAAAAAAAAAAAAAAAAAAAAAAAAAAAAAFAAAADwAAAAAAAAAAAAAAAAAAAkUAAAAAQAAABQAAAAUAAAAFAAAAAEAAAAAAAAAZAAAAGQAAAAAAAAAZAAAAGQAAAAVAAAAYAAAAAAAAAAAAAAADwAAACADAAAAAAAAAAAAAAEAAACgMgAAVgcAAKr4//8BAAAAf39/AAEAAABkAAAAAAAAABQAAABAHwAAAAAAACYAAAAAAAAAwOD//wAAAAAmAAAAZAAAABYAAABMAAAAAAAAAAAAAAAEAAAAAAAAAAEAAABZWVkKAAAAACgAAAAoAAAAZAAAAGQAAAAAAAAAzMzMAAAAAABQAAAAUAAAAGQAAABkAAAAAAAAABcAAAAUAAAAAAAAAAAAAAD/fwAA/38AAAAAAAAJAAAABAAAAAAAAAAeAAAAaAAAAAAAAAAAAAAAAAAAAAAAAAAAAAAAECcAABAnAAAAAAAAAAAAAAAAAAAAAAAAAAAAAAAAAAAAAAAAAAAAABQAAAAAAAAAwMD/AAAAAABkAAAAMgAAAAAAAABkAAAAAAAAAH9/fwAKAAAAIgAAABgAAAAAAAAAAAAAAAAAAAAAAAAAAAAAAAAAAAAkAAAAJAAAAAAAAAAHAAAAAAAAAAAAAAAAAAAAAAAAAAAAAAAAAAAAf39/ACUAAABYAAAAAAAAAAAAAAAAAAAAAAAAAAAAAAAAAAAAAAAAAAAAAAAAAAAAAAAAAAAAAAA/AAAAAAAAAKCGAQAAAAAAAAAAAAAAAAAMAAAAAQAAAAAAAAAAAAAAAAAAAB8AAABUAAAAAAAABQAAAAEAAAAAAAAAAAAAAAAAAAAAAAAAAAAAAAAAAAAAAAAAAAAAAAJ/f38AAAAAA8zMzADAwP8Af39/AAAAAAAAAAAAAAAAAAAAAAAAAAAAIQAAABgAAAAUAAAAFAMAALYCAAB/NwAAvwoAABAAAAAmAAAACAAAADywAAAAAAAA"/>
+                <pr:smNativeData xmlns:pr="smNativeData" xmlns="smNativeData" val="SMDATA_15_FUV5ZhMAAAAlAAAAZAAAAA0AAAAAkAAAAJAAAACQAAAAkAAAAAAAAAAAAAAAAAAAAAEAAABQAAAAAAAAAAAA4D8AAAAAAADgPwAAAAAAAOA/AAAAAAAA4D8AAAAAAADgPwAAAAAAAOA/AAAAAAAA4D8AAAAAAADgPwAAAAAAAOA/AAAAAAAA4D8CAAAAjAAAAAAAAAAAAAAAQoX0DP///wgAAAAAAAAAAAAAAAAAAAAAAAAAAAAAAAAAAAAAZAAAAAEAAABAAAAAAAAAAAAAAAAAAAAAAAAAAAAAAAAAAAAAAAAAAAAAAAAAAAAAAAAAAAAAAAAAAAAAAAAAAAAAAAAAAAAAAAAAAAAAAAAAAAAAAAAAAAAAAAAAAAAAFAAAADwAAAAAAAAAAAAAAAAAAAkUAAAAAQAAABQAAAAUAAAAFAAAAAEAAAAAAAAAZAAAAGQAAAAAAAAAZAAAAGQAAAAVAAAAYAAAAAAAAAAAAAAADwAAACADAAAAAAAAAAAAAAEAAACgMgAAVgcAAKr4//8BAAAAf39/AAEAAABkAAAAAAAAABQAAABAHwAAAAAAACYAAAAAAAAAwOD//wAAAAAmAAAAZAAAABYAAABMAAAAAAAAAAAAAAAEAAAAAAAAAAEAAABZWVkKAAAAACgAAAAoAAAAZAAAAGQAAAAAAAAAzMzMAAAAAABQAAAAUAAAAGQAAABkAAAAAAAAABcAAAAUAAAAAAAAAAAAAAD/fwAA/38AAAAAAAAJAAAABAAAAAAAAAAeAAAAaAAAAAAAAAAAAAAAAAAAAAAAAAAAAAAAECcAABAnAAAAAAAAAAAAAAAAAAAAAAAAAAAAAAAAAAAAAAAAAAAAABQAAAAAAAAAwMD/AAAAAABkAAAAMgAAAAAAAABkAAAAAAAAAH9/fwAKAAAAIgAAABgAAAAAAAAAAAAAAAAAAAAAAAAAAAAAAAAAAAAkAAAAJAAAAAAAAAAHAAAAAAAAAAAAAAAAAAAAAAAAAAAAAAAAAAAAf39/ACUAAABYAAAAAAAAAAAAAAAAAAAAAAAAAAAAAAAAAAAAAAAAAAAAAAAAAAAAAAAAAAAAAAA/AAAAAAAAAKCGAQAAAAAAAAAAAAAAAAAMAAAAAQAAAAAAAAAAAAAAAAAAAB8AAABUAAAAAAAABQAAAAEAAAAAAAAAAAAAAAAAAAAAAAAAAAAAAAAAAAAAAAAAAAAAAAJ/f38AAAAAA8zMzADAwP8Af39/AAAAAAAAAAAAAAAAAAAAAAAAAAAAIQAAABgAAAAUAAAAFAMAALYCAAB/NwAAvwoAABAAAAAmAAAACAAAADywAAAAAAAA"/>
               </a:ext>
             </a:extLst>
           </p:cNvSpPr>
@@ -3357,7 +3357,7 @@
           <p:cNvSpPr>
             <a:extLst>
               <a:ext uri="smNativeData">
-                <pr:smNativeData xmlns:pr="smNativeData" xmlns="smNativeData" val="SMDATA_15_LkR5ZhMAAAAlAAAAZAAAAA0AAAAAkAAAAJAAAACQAAAAkAAAAAAAAAABAAAAAAAAAAEAAABQAAAAAAAAAAAA4D8AAAAAAADgPwAAAAAAAOA/AAAAAAAA4D8AAAAAAADgPwAAAAAAAOA/AAAAAAAA4D8AAAAAAADgPwAAAAAAAOA/AAAAAAAA4D8CAAAAjAAAAAEAAAAAAAAA+/v+AP///wgAAAAAAAAAAAAAAAAAAAAAAAAAAAAAAAAAAAAAeAAAAAEAAABAAAAAAAAAAAAAAABaAAAAAAAAAAAAAAAAAAAAAAAAAAAAAAAAAAAAAAAAAAAAAAAAAAAAAAAAAAAAAAAAAAAAAAAAAAAAAAAAAAAAAAAAAAAAAAAAAAAAFAAAADwAAAAAAAAAAAAAAAAAAAkUAAAAAQAAABQAAAAUAAAAFAAAAAEAAAAAAAAAZAAAAGQAAAAAAAAAZAAAAGQAAAAVAAAAYAAAAAAAAAAAAAAADwAAACADAAAAAAAAAAAAAAEAAACgMgAAVgcAAKr4//8BAAAAf39/AAEAAABkAAAAAAAAABQAAABAHwAAAAAAACYAAAAAAAAAwOD//wAAAAAmAAAAZAAAABYAAABMAAAAAAAAAAAAAAAEAAAAAAAAAAEAAABZWVkKAAAAACgAAAAoAAAAZAAAAGQAAAAAAAAAzMzMAAAAAABQAAAAUAAAAGQAAABkAAAAAAAAABcAAAAUAAAAAAAAAAAAAAD/fwAA/38AAAAAAAAJAAAABAAAAAAAAAAeAAAAaAAAAAAAAAAAAAAAAAAAAAAAAAAAAAAAECcAABAnAAAAAAAAAAAAAAAAAAAAAAAAAAAAAAAAAAAAAAAAAAAAABQAAAAAAAAAwMD/AAAAAABkAAAAMgAAAAAAAABkAAAAAAAAAH9/fwAKAAAAIgAAABgAAAAAAAAAAAAAAAAAAAAAAAAAAAAAAAAAAAAkAAAAJAAAAAAAAAAHAAAAAAAAAAAAAAAAAAAAAAAAAAAAAAAAAAAAf39/ACUAAABYAAAAAAAAAAAAAAAAAAAAAAAAAAAAAAAAAAAAAAAAAAAAAAAAAAAAAAAAAAAAAAA/AAAAAAAAAKCGAQAAAAAAAAAAAAAAAAAMAAAAAQAAAAAAAAAAAAAAAAAAAB8AAABUAAAA+/v+AAAAAAEAAAAAAAAAAAAAAAAAAAAAAAAAAAAAAAAAAAAAAAAAAAAAAAJ/f38AAAAAA8zMzADAwP8Af39/AAAAAAAAAAAAAAAAAAAAAAAAAAAAIQAAABgAAAAUAAAAuwMAAJYRAACQNAAAzSUAABAAAAAmAAAACAAAAP//////////"/>
+                <pr:smNativeData xmlns:pr="smNativeData" xmlns="smNativeData" val="SMDATA_15_FUV5ZhMAAAAlAAAAZAAAAA0AAAAAkAAAAJAAAACQAAAAkAAAAAAAAAABAAAAAAAAAAEAAABQAAAAAAAAAAAA4D8AAAAAAADgPwAAAAAAAOA/AAAAAAAA4D8AAAAAAADgPwAAAAAAAOA/AAAAAAAA4D8AAAAAAADgPwAAAAAAAOA/AAAAAAAA4D8CAAAAjAAAAAEAAAAAAAAA+/v+AP///wgAAAAAAAAAAAAAAAAAAAAAAAAAAAAAAAAAAAAAeAAAAAEAAABAAAAAAAAAAAAAAABaAAAAAAAAAAAAAAAAAAAAAAAAAAAAAAAAAAAAAAAAAAAAAAAAAAAAAAAAAAAAAAAAAAAAAAAAAAAAAAAAAAAAAAAAAAAAAAAAAAAAFAAAADwAAAAAAAAAAAAAAAAAAAkUAAAAAQAAABQAAAAUAAAAFAAAAAEAAAAAAAAAZAAAAGQAAAAAAAAAZAAAAGQAAAAVAAAAYAAAAAAAAAAAAAAADwAAACADAAAAAAAAAAAAAAEAAACgMgAAVgcAAKr4//8BAAAAf39/AAEAAABkAAAAAAAAABQAAABAHwAAAAAAACYAAAAAAAAAwOD//wAAAAAmAAAAZAAAABYAAABMAAAAAAAAAAAAAAAEAAAAAAAAAAEAAABZWVkKAAAAACgAAAAoAAAAZAAAAGQAAAAAAAAAzMzMAAAAAABQAAAAUAAAAGQAAABkAAAAAAAAABcAAAAUAAAAAAAAAAAAAAD/fwAA/38AAAAAAAAJAAAABAAAAAAAAAAeAAAAaAAAAAAAAAAAAAAAAAAAAAAAAAAAAAAAECcAABAnAAAAAAAAAAAAAAAAAAAAAAAAAAAAAAAAAAAAAAAAAAAAABQAAAAAAAAAwMD/AAAAAABkAAAAMgAAAAAAAABkAAAAAAAAAH9/fwAKAAAAIgAAABgAAAAAAAAAAAAAAAAAAAAAAAAAAAAAAAAAAAAkAAAAJAAAAAAAAAAHAAAAAAAAAAAAAAAAAAAAAAAAAAAAAAAAAAAAf39/ACUAAABYAAAAAAAAAAAAAAAAAAAAAAAAAAAAAAAAAAAAAAAAAAAAAAAAAAAAAAAAAAAAAAA/AAAAAAAAAKCGAQAAAAAAAAAAAAAAAAAMAAAAAQAAAAAAAAAAAAAAAAAAAB8AAABUAAAA+/v+AAAAAAEAAAAAAAAAAAAAAAAAAAAAAAAAAAAAAAAAAAAAAAAAAAAAAAJ/f38AAAAAA8zMzADAwP8Af39/AAAAAAAAAAAAAAAAAAAAAAAAAAAAIQAAABgAAAAUAAAAuwMAAJYRAACQNAAAzSUAABAAAAAmAAAACAAAAP//////////"/>
               </a:ext>
             </a:extLst>
           </p:cNvSpPr>
@@ -3402,7 +3402,7 @@
             <a:spLocks noGrp="1" noChangeArrowheads="1"/>
             <a:extLst>
               <a:ext uri="smNativeData">
-                <pr:smNativeData xmlns:pr="smNativeData" xmlns="smNativeData" val="SMDATA_15_LkR5ZhMAAAAlAAAAZAAAAA0AAAAAkAAAAJAAAACQAAAAkAAAAAAAAAAAAAAAAAAAAAEAAABQAAAAAAAAAAAA4D8AAAAAAADgPwAAAAAAAOA/AAAAAAAA4D8AAAAAAADgPwAAAAAAAOA/AAAAAAAA4D8AAAAAAADgPwAAAAAAAOA/AAAAAAAA4D8CAAAAjAAAAAAAAAAAAAAAQoX0DP///wgAAAAAAAAAAAAAAAAAAAAAAAAAAAAAAAAAAAAAZAAAAAEAAABAAAAAAAAAAAAAAAAAAAAAAAAAAAAAAAAAAAAAAAAAAAAAAAAAAAAAAAAAAAAAAAAAAAAAAAAAAAAAAAAAAAAAAAAAAAAAAAAAAAAAAAAAAAAAAAAAAAAAFAAAADwAAAAAAAAAAAAAAAAAAAkUAAAAAQAAABQAAAAUAAAAFAAAAAEAAAAAAAAAZAAAAGQAAAAAAAAAZAAAAGQAAAAVAAAAYAAAAAAAAAAAAAAADwAAACADAAAAAAAAAAAAAAEAAACgMgAAVgcAAKr4//8BAAAAf39/AAEAAABkAAAAAAAAABQAAABAHwAAAAAAACYAAAAAAAAAwOD//wAAAAAmAAAAZAAAABYAAABMAAAAAAAAAAAAAAAEAAAAAAAAAAEAAABZWVkKAAAAACgAAAAoAAAAZAAAAGQAAAAAAAAAzMzMAAAAAABQAAAAUAAAAGQAAABkAAAAAAAAABcAAAAUAAAAAAAAAAAAAAD/fwAA/38AAAAAAAAJAAAABAAAAAAAAAAeAAAAaAAAAAAAAAAAAAAAAAAAAAAAAAAAAAAAECcAABAnAAAAAAAAAAAAAAAAAAAAAAAAAAAAAAAAAAAAAAAAAAAAABQAAAAAAAAAwMD/AAAAAABkAAAAMgAAAAAAAABkAAAAAAAAAH9/fwAKAAAAIgAAABgAAAAAAAAAAAAAAAAAAAAAAAAAAAAAAAAAAAAkAAAAJAAAAAAAAAAHAAAAAAAAAAAAAAAAAAAAAAAAAAAAAAAAAAAAf39/ACUAAABYAAAAAAAAAAAAAAAAAAAAAAAAAAAAAAAAAAAAAAAAAAAAAAAAAAAAAAAAAAAAAAA/AAAAAAAAAKCGAQAAAAAAAAAAAAAAAAAMAAAAAQAAAAAAAAAAAAAAAAAAAB8AAABUAAAAAAAABQAAAAEAAAAAAAAAAAAAAAAAAAAAAAAAAAAAAAAAAAAAAAAAAAAAAAJ/f38AAAAAA8zMzADAwP8Af39/AAAAAAAAAAAAAAAAAAAAAAAAAAAAIQAAABgAAAAUAAAAfAQAAIESAAC5NQAAuCYAABAAAAAmAAAACAAAAD2wAAAAAAAA"/>
+                <pr:smNativeData xmlns:pr="smNativeData" xmlns="smNativeData" val="SMDATA_15_FUV5ZhMAAAAlAAAAZAAAAA0AAAAAkAAAAJAAAACQAAAAkAAAAAAAAAAAAAAAAAAAAAEAAABQAAAAAAAAAAAA4D8AAAAAAADgPwAAAAAAAOA/AAAAAAAA4D8AAAAAAADgPwAAAAAAAOA/AAAAAAAA4D8AAAAAAADgPwAAAAAAAOA/AAAAAAAA4D8CAAAAjAAAAAAAAAAAAAAAQoX0DP///wgAAAAAAAAAAAAAAAAAAAAAAAAAAAAAAAAAAAAAZAAAAAEAAABAAAAAAAAAAAAAAAAAAAAAAAAAAAAAAAAAAAAAAAAAAAAAAAAAAAAAAAAAAAAAAAAAAAAAAAAAAAAAAAAAAAAAAAAAAAAAAAAAAAAAAAAAAAAAAAAAAAAAFAAAADwAAAAAAAAAAAAAAAAAAAkUAAAAAQAAABQAAAAUAAAAFAAAAAEAAAAAAAAAZAAAAGQAAAAAAAAAZAAAAGQAAAAVAAAAYAAAAAAAAAAAAAAADwAAACADAAAAAAAAAAAAAAEAAACgMgAAVgcAAKr4//8BAAAAf39/AAEAAABkAAAAAAAAABQAAABAHwAAAAAAACYAAAAAAAAAwOD//wAAAAAmAAAAZAAAABYAAABMAAAAAAAAAAAAAAAEAAAAAAAAAAEAAABZWVkKAAAAACgAAAAoAAAAZAAAAGQAAAAAAAAAzMzMAAAAAABQAAAAUAAAAGQAAABkAAAAAAAAABcAAAAUAAAAAAAAAAAAAAD/fwAA/38AAAAAAAAJAAAABAAAAAAAAAAeAAAAaAAAAAAAAAAAAAAAAAAAAAAAAAAAAAAAECcAABAnAAAAAAAAAAAAAAAAAAAAAAAAAAAAAAAAAAAAAAAAAAAAABQAAAAAAAAAwMD/AAAAAABkAAAAMgAAAAAAAABkAAAAAAAAAH9/fwAKAAAAIgAAABgAAAAAAAAAAAAAAAAAAAAAAAAAAAAAAAAAAAAkAAAAJAAAAAAAAAAHAAAAAAAAAAAAAAAAAAAAAAAAAAAAAAAAAAAAf39/ACUAAABYAAAAAAAAAAAAAAAAAAAAAAAAAAAAAAAAAAAAAAAAAAAAAAAAAAAAAAAAAAAAAAA/AAAAAAAAAKCGAQAAAAAAAAAAAAAAAAAMAAAAAQAAAAAAAAAAAAAAAAAAAB8AAABUAAAAAAAABQAAAAEAAAAAAAAAAAAAAAAAAAAAAAAAAAAAAAAAAAAAAAAAAAAAAAJ/f38AAAAAA8zMzADAwP8Af39/AAAAAAAAAAAAAAAAAAAAAAAAAAAAIQAAABgAAAAUAAAAfAQAAIESAAC5NQAAuCYAABAAAAAmAAAACAAAAD2wAAAAAAAA"/>
               </a:ext>
             </a:extLst>
           </p:cNvSpPr>
@@ -3585,7 +3585,7 @@
             <a:spLocks noGrp="1" noChangeArrowheads="1"/>
             <a:extLst>
               <a:ext uri="smNativeData">
-                <pr:smNativeData xmlns:pr="smNativeData" xmlns="smNativeData" val="SMDATA_15_LkR5ZhMAAAAlAAAAZAAAAA0AAAAAkAAAAJAAAACQAAAAkAAAAAAAAAAAAAAAAAAAAAEAAABQAAAAAAAAAAAA4D8AAAAAAADgPwAAAAAAAOA/AAAAAAAA4D8AAAAAAADgPwAAAAAAAOA/AAAAAAAA4D8AAAAAAADgPwAAAAAAAOA/AAAAAAAA4D8CAAAAjAAAAAAAAAAAAAAAQoX0DP///wgAAAAAAAAAAAAAAAAAAAAAAAAAAAAAAAAAAAAAZAAAAAEAAABAAAAAAAAAAAAAAAAAAAAAAAAAAAAAAAAAAAAAAAAAAAAAAAAAAAAAAAAAAAAAAAAAAAAAAAAAAAAAAAAAAAAAAAAAAAAAAAAAAAAAAAAAAAAAAAAAAAAAFAAAADwAAAAAAAAAAAAAAAAAAAkUAAAAAQAAABQAAAAUAAAAFAAAAAEAAAAAAAAAZAAAAGQAAAAAAAAAZAAAAGQAAAAVAAAAYAAAAAAAAAAAAAAADwAAACADAAAAAAAAAAAAAAEAAACgMgAAVgcAAKr4//8BAAAAf39/AAEAAABkAAAAAAAAABQAAABAHwAAAAAAACYAAAAAAAAAwOD//wAAAAAmAAAAZAAAABYAAABMAAAAAAAAAAAAAAAEAAAAAAAAAAEAAABZWVkKAAAAACgAAAAoAAAAZAAAAGQAAAAAAAAAzMzMAAAAAABQAAAAUAAAAGQAAABkAAAAAAAAABcAAAAUAAAAAAAAAAAAAAD/fwAA/38AAAAAAAAJAAAABAAAAAAAAAAeAAAAaAAAAAAAAAAAAAAAAAAAAAAAAAAAAAAAECcAABAnAAAAAAAAAAAAAAAAAAAAAAAAAAAAAAAAAAAAAAAAAAAAABQAAAAAAAAAwMD/AAAAAABkAAAAMgAAAAAAAABkAAAAAAAAAH9/fwAKAAAAIgAAABgAAAAAAAAAAAAAAAAAAAAAAAAAAAAAAAAAAAAkAAAAJAAAAAAAAAAHAAAAAAAAAAAAAAAAAAAAAAAAAAAAAAAAAAAAf39/ACUAAABYAAAAAAAAAAAAAAAAAAAAAAAAAAAAAAAAAAAAAAAAAAAAAAAAAAAAAAAAAAAAAAA/AAAAAAAAAKCGAQAAAAAAAAAAAAAAAAAMAAAAAQAAAAAAAAAAAAAAAAAAAB8AAABUAAAAAAAABQAAAAEAAAAAAAAAAAAAAAAAAAAAAAAAAAAAAAAAAAAAAAAAAAAAAAJ/f38AAAAAA8zMzADAwP8Af39/AAAAAAAAAAAAAAAAAAAAAAAAAAAAIQAAABgAAAAUAAAAQwMAAA4LAABBNQAAlhEAABAAAAAmAAAACAAAAD2wAAAAAAAA"/>
+                <pr:smNativeData xmlns:pr="smNativeData" xmlns="smNativeData" val="SMDATA_15_FUV5ZhMAAAAlAAAAZAAAAA0AAAAAkAAAAJAAAACQAAAAkAAAAAAAAAAAAAAAAAAAAAEAAABQAAAAAAAAAAAA4D8AAAAAAADgPwAAAAAAAOA/AAAAAAAA4D8AAAAAAADgPwAAAAAAAOA/AAAAAAAA4D8AAAAAAADgPwAAAAAAAOA/AAAAAAAA4D8CAAAAjAAAAAAAAAAAAAAAQoX0DP///wgAAAAAAAAAAAAAAAAAAAAAAAAAAAAAAAAAAAAAZAAAAAEAAABAAAAAAAAAAAAAAAAAAAAAAAAAAAAAAAAAAAAAAAAAAAAAAAAAAAAAAAAAAAAAAAAAAAAAAAAAAAAAAAAAAAAAAAAAAAAAAAAAAAAAAAAAAAAAAAAAAAAAFAAAADwAAAAAAAAAAAAAAAAAAAkUAAAAAQAAABQAAAAUAAAAFAAAAAEAAAAAAAAAZAAAAGQAAAAAAAAAZAAAAGQAAAAVAAAAYAAAAAAAAAAAAAAADwAAACADAAAAAAAAAAAAAAEAAACgMgAAVgcAAKr4//8BAAAAf39/AAEAAABkAAAAAAAAABQAAABAHwAAAAAAACYAAAAAAAAAwOD//wAAAAAmAAAAZAAAABYAAABMAAAAAAAAAAAAAAAEAAAAAAAAAAEAAABZWVkKAAAAACgAAAAoAAAAZAAAAGQAAAAAAAAAzMzMAAAAAABQAAAAUAAAAGQAAABkAAAAAAAAABcAAAAUAAAAAAAAAAAAAAD/fwAA/38AAAAAAAAJAAAABAAAAAAAAAAeAAAAaAAAAAAAAAAAAAAAAAAAAAAAAAAAAAAAECcAABAnAAAAAAAAAAAAAAAAAAAAAAAAAAAAAAAAAAAAAAAAAAAAABQAAAAAAAAAwMD/AAAAAABkAAAAMgAAAAAAAABkAAAAAAAAAH9/fwAKAAAAIgAAABgAAAAAAAAAAAAAAAAAAAAAAAAAAAAAAAAAAAAkAAAAJAAAAAAAAAAHAAAAAAAAAAAAAAAAAAAAAAAAAAAAAAAAAAAAf39/ACUAAABYAAAAAAAAAAAAAAAAAAAAAAAAAAAAAAAAAAAAAAAAAAAAAAAAAAAAAAAAAAAAAAA/AAAAAAAAAKCGAQAAAAAAAAAAAAAAAAAMAAAAAQAAAAAAAAAAAAAAAAAAAB8AAABUAAAAAAAABQAAAAEAAAAAAAAAAAAAAAAAAAAAAAAAAAAAAAAAAAAAAAAAAAAAAAJ/f38AAAAAA8zMzADAwP8Af39/AAAAAAAAAAAAAAAAAAAAAAAAAAAAIQAAABgAAAAUAAAAQwMAAA4LAABBNQAAlhEAABAAAAAmAAAACAAAAD2wAAAAAAAA"/>
               </a:ext>
             </a:extLst>
           </p:cNvSpPr>
@@ -3797,7 +3797,7 @@
             <a:spLocks noGrp="1" noChangeArrowheads="1"/>
             <a:extLst>
               <a:ext uri="smNativeData">
-                <pr:smNativeData xmlns:pr="smNativeData" xmlns="smNativeData" val="SMDATA_15_LkR5ZhMAAAAlAAAAZAAAAA0AAAAAkAAAAJAAAACQAAAAkAAAAAAAAAAAAAAAAAAAAAEAAABQAAAAAAAAAAAA4D8AAAAAAADgPwAAAAAAAOA/AAAAAAAA4D8AAAAAAADgPwAAAAAAAOA/AAAAAAAA4D8AAAAAAADgPwAAAAAAAOA/AAAAAAAA4D8CAAAAjAAAAAAAAAAAAAAAQoX0DP///wgAAAAAAAAAAAAAAAAAAAAAAAAAAAAAAAAAAAAAZAAAAAEAAABAAAAAAAAAAAAAAAAAAAAAAAAAAAAAAAAAAAAAAAAAAAAAAAAAAAAAAAAAAAAAAAAAAAAAAAAAAAAAAAAAAAAAAAAAAAAAAAAAAAAAAAAAAAAAAAAAAAAAFAAAADwAAAAAAAAAAAAAAAAAAAkUAAAAAQAAABQAAAAUAAAAFAAAAAEAAAAAAAAAZAAAAGQAAAAAAAAAZAAAAGQAAAAVAAAAYAAAAAAAAAAAAAAADwAAACADAAAAAAAAAAAAAAEAAACgMgAAVgcAAKr4//8BAAAAf39/AAEAAABkAAAAAAAAABQAAABAHwAAAAAAACYAAAAAAAAAwOD//wAAAAAmAAAAZAAAABYAAABMAAAAAAAAAAAAAAAEAAAAAAAAAAEAAABZWVkKAAAAACgAAAAoAAAAZAAAAGQAAAAAAAAAzMzMAAAAAABQAAAAUAAAAGQAAABkAAAAAAAAABcAAAAUAAAAAAAAAAAAAAD/fwAA/38AAAAAAAAJAAAABAAAAAAAAAAeAAAAaAAAAAAAAAAAAAAAAAAAAAAAAAAAAAAAECcAABAnAAAAAAAAAAAAAAAAAAAAAAAAAAAAAAAAAAAAAAAAAAAAABQAAAAAAAAAwMD/AAAAAABkAAAAMgAAAAAAAABkAAAAAAAAAH9/fwAKAAAAIgAAABgAAAAAAAAAAAAAAAAAAAAAAAAAAAAAAAAAAAAkAAAAJAAAAAAAAAAHAAAAAAAAAAAAAAAAAAAAAAAAAAAAAAAAAAAAf39/ACUAAABYAAAAAAAAAAAAAAAAAAAAAAAAAAAAAAAAAAAAAAAAAAAAAAAAAAAAAAAAAAAAAAA/AAAAAAAAAKCGAQAAAAAAAAAAAAAAAAAMAAAAAQAAAAAAAAAAAAAAAAAAAB8AAABUAAAAAAAABQAAAAEAAAAAAAAAAAAAAAAAAAAAAAAAAAAAAAAAAAAAAAAAAAAAAAJ/f38AAAAAA8zMzADAwP8Af39/AAAAAAAAAAAAAAAAAAAAAAAAAAAAIQAAABgAAAAUAAAAFAMAALYCAAB/NwAAvwoAABAAAAAmAAAACAAAADywAAAAAAAA"/>
+                <pr:smNativeData xmlns:pr="smNativeData" xmlns="smNativeData" val="SMDATA_15_FUV5ZhMAAAAlAAAAZAAAAA0AAAAAkAAAAJAAAACQAAAAkAAAAAAAAAAAAAAAAAAAAAEAAABQAAAAAAAAAAAA4D8AAAAAAADgPwAAAAAAAOA/AAAAAAAA4D8AAAAAAADgPwAAAAAAAOA/AAAAAAAA4D8AAAAAAADgPwAAAAAAAOA/AAAAAAAA4D8CAAAAjAAAAAAAAAAAAAAAQoX0DP///wgAAAAAAAAAAAAAAAAAAAAAAAAAAAAAAAAAAAAAZAAAAAEAAABAAAAAAAAAAAAAAAAAAAAAAAAAAAAAAAAAAAAAAAAAAAAAAAAAAAAAAAAAAAAAAAAAAAAAAAAAAAAAAAAAAAAAAAAAAAAAAAAAAAAAAAAAAAAAAAAAAAAAFAAAADwAAAAAAAAAAAAAAAAAAAkUAAAAAQAAABQAAAAUAAAAFAAAAAEAAAAAAAAAZAAAAGQAAAAAAAAAZAAAAGQAAAAVAAAAYAAAAAAAAAAAAAAADwAAACADAAAAAAAAAAAAAAEAAACgMgAAVgcAAKr4//8BAAAAf39/AAEAAABkAAAAAAAAABQAAABAHwAAAAAAACYAAAAAAAAAwOD//wAAAAAmAAAAZAAAABYAAABMAAAAAAAAAAAAAAAEAAAAAAAAAAEAAABZWVkKAAAAACgAAAAoAAAAZAAAAGQAAAAAAAAAzMzMAAAAAABQAAAAUAAAAGQAAABkAAAAAAAAABcAAAAUAAAAAAAAAAAAAAD/fwAA/38AAAAAAAAJAAAABAAAAAAAAAAeAAAAaAAAAAAAAAAAAAAAAAAAAAAAAAAAAAAAECcAABAnAAAAAAAAAAAAAAAAAAAAAAAAAAAAAAAAAAAAAAAAAAAAABQAAAAAAAAAwMD/AAAAAABkAAAAMgAAAAAAAABkAAAAAAAAAH9/fwAKAAAAIgAAABgAAAAAAAAAAAAAAAAAAAAAAAAAAAAAAAAAAAAkAAAAJAAAAAAAAAAHAAAAAAAAAAAAAAAAAAAAAAAAAAAAAAAAAAAAf39/ACUAAABYAAAAAAAAAAAAAAAAAAAAAAAAAAAAAAAAAAAAAAAAAAAAAAAAAAAAAAAAAAAAAAA/AAAAAAAAAKCGAQAAAAAAAAAAAAAAAAAMAAAAAQAAAAAAAAAAAAAAAAAAAB8AAABUAAAAAAAABQAAAAEAAAAAAAAAAAAAAAAAAAAAAAAAAAAAAAAAAAAAAAAAAAAAAAJ/f38AAAAAA8zMzADAwP8Af39/AAAAAAAAAAAAAAAAAAAAAAAAAAAAIQAAABgAAAAUAAAAFAMAALYCAAB/NwAAvwoAABAAAAAmAAAACAAAADywAAAAAAAA"/>
               </a:ext>
             </a:extLst>
           </p:cNvSpPr>
@@ -3906,7 +3906,7 @@
           <p:cNvSpPr>
             <a:extLst>
               <a:ext uri="smNativeData">
-                <pr:smNativeData xmlns:pr="smNativeData" xmlns="smNativeData" val="SMDATA_15_LkR5ZhMAAAAlAAAAZAAAAA0AAAAAkAAAAJAAAACQAAAAkAAAAAAAAAABAAAAAAAAAAEAAABQAAAAAAAAAAAA4D8AAAAAAADgPwAAAAAAAOA/AAAAAAAA4D8AAAAAAADgPwAAAAAAAOA/AAAAAAAA4D8AAAAAAADgPwAAAAAAAOA/AAAAAAAA4D8CAAAAjAAAAAEAAAAAAAAA+/v+AP///wgAAAAAAAAAAAAAAAAAAAAAAAAAAAAAAAAAAAAAeAAAAAEAAABAAAAAAAAAAAAAAABaAAAAAAAAAAAAAAAAAAAAAAAAAAAAAAAAAAAAAAAAAAAAAAAAAAAAAAAAAAAAAAAAAAAAAAAAAAAAAAAAAAAAAAAAAAAAAAAAAAAAFAAAADwAAAAAAAAAAAAAAAAAAAkUAAAAAQAAABQAAAAUAAAAFAAAAAEAAAAAAAAAZAAAAGQAAAAAAAAAZAAAAGQAAAAVAAAAYAAAAAAAAAAAAAAADwAAACADAAAAAAAAAAAAAAEAAACgMgAAVgcAAKr4//8BAAAAf39/AAEAAABkAAAAAAAAABQAAABAHwAAAAAAACYAAAAAAAAAwOD//wAAAAAmAAAAZAAAABYAAABMAAAAAAAAAAAAAAAEAAAAAAAAAAEAAABZWVkKAAAAACgAAAAoAAAAZAAAAGQAAAAAAAAAzMzMAAAAAABQAAAAUAAAAGQAAABkAAAAAAAAABcAAAAUAAAAAAAAAAAAAAD/fwAA/38AAAAAAAAJAAAABAAAAAAAAAAeAAAAaAAAAAAAAAAAAAAAAAAAAAAAAAAAAAAAECcAABAnAAAAAAAAAAAAAAAAAAAAAAAAAAAAAAAAAAAAAAAAAAAAABQAAAAAAAAAwMD/AAAAAABkAAAAMgAAAAAAAABkAAAAAAAAAH9/fwAKAAAAIgAAABgAAAAAAAAAAAAAAAAAAAAAAAAAAAAAAAAAAAAkAAAAJAAAAAAAAAAHAAAAAAAAAAAAAAAAAAAAAAAAAAAAAAAAAAAAf39/ACUAAABYAAAAAAAAAAAAAAAAAAAAAAAAAAAAAAAAAAAAAAAAAAAAAAAAAAAAAAAAAAAAAAA/AAAAAAAAAKCGAQAAAAAAAAAAAAAAAAAMAAAAAQAAAAAAAAAAAAAAAAAAAB8AAABUAAAA+/v+AAAAAAEAAAAAAAAAAAAAAAAAAAAAAAAAAAAAAAAAAAAAAAAAAAAAAAJ/f38AAAAAA8zMzADAwP8Af39/AAAAAAAAAAAAAAAAAAAAAAAAAAAAIQAAABgAAAAUAAAAOwIAAPIJAABxHwAALycAABAAAAAmAAAACAAAAP//////////"/>
+                <pr:smNativeData xmlns:pr="smNativeData" xmlns="smNativeData" val="SMDATA_15_FUV5ZhMAAAAlAAAAZAAAAA0AAAAAkAAAAJAAAACQAAAAkAAAAAAAAAABAAAAAAAAAAEAAABQAAAAAAAAAAAA4D8AAAAAAADgPwAAAAAAAOA/AAAAAAAA4D8AAAAAAADgPwAAAAAAAOA/AAAAAAAA4D8AAAAAAADgPwAAAAAAAOA/AAAAAAAA4D8CAAAAjAAAAAEAAAAAAAAA+/v+AP///wgAAAAAAAAAAAAAAAAAAAAAAAAAAAAAAAAAAAAAeAAAAAEAAABAAAAAAAAAAAAAAABaAAAAAAAAAAAAAAAAAAAAAAAAAAAAAAAAAAAAAAAAAAAAAAAAAAAAAAAAAAAAAAAAAAAAAAAAAAAAAAAAAAAAAAAAAAAAAAAAAAAAFAAAADwAAAAAAAAAAAAAAAAAAAkUAAAAAQAAABQAAAAUAAAAFAAAAAEAAAAAAAAAZAAAAGQAAAAAAAAAZAAAAGQAAAAVAAAAYAAAAAAAAAAAAAAADwAAACADAAAAAAAAAAAAAAEAAACgMgAAVgcAAKr4//8BAAAAf39/AAEAAABkAAAAAAAAABQAAABAHwAAAAAAACYAAAAAAAAAwOD//wAAAAAmAAAAZAAAABYAAABMAAAAAAAAAAAAAAAEAAAAAAAAAAEAAABZWVkKAAAAACgAAAAoAAAAZAAAAGQAAAAAAAAAzMzMAAAAAABQAAAAUAAAAGQAAABkAAAAAAAAABcAAAAUAAAAAAAAAAAAAAD/fwAA/38AAAAAAAAJAAAABAAAAAAAAAAeAAAAaAAAAAAAAAAAAAAAAAAAAAAAAAAAAAAAECcAABAnAAAAAAAAAAAAAAAAAAAAAAAAAAAAAAAAAAAAAAAAAAAAABQAAAAAAAAAwMD/AAAAAABkAAAAMgAAAAAAAABkAAAAAAAAAH9/fwAKAAAAIgAAABgAAAAAAAAAAAAAAAAAAAAAAAAAAAAAAAAAAAAkAAAAJAAAAAAAAAAHAAAAAAAAAAAAAAAAAAAAAAAAAAAAAAAAAAAAf39/ACUAAABYAAAAAAAAAAAAAAAAAAAAAAAAAAAAAAAAAAAAAAAAAAAAAAAAAAAAAAAAAAAAAAA/AAAAAAAAAKCGAQAAAAAAAAAAAAAAAAAMAAAAAQAAAAAAAAAAAAAAAAAAAB8AAABUAAAA+/v+AAAAAAEAAAAAAAAAAAAAAAAAAAAAAAAAAAAAAAAAAAAAAAAAAAAAAAJ/f38AAAAAA8zMzADAwP8Af39/AAAAAAAAAAAAAAAAAAAAAAAAAAAAIQAAABgAAAAUAAAAOwIAAPIJAABxHwAALycAABAAAAAmAAAACAAAAP//////////"/>
               </a:ext>
             </a:extLst>
           </p:cNvSpPr>
@@ -3951,7 +3951,7 @@
             <a:spLocks noGrp="1" noChangeArrowheads="1"/>
             <a:extLst>
               <a:ext uri="smNativeData">
-                <pr:smNativeData xmlns:pr="smNativeData" xmlns="smNativeData" val="SMDATA_15_LkR5ZhMAAAAlAAAAZAAAAA0AAAAAkAAAAJAAAACQAAAAkAAAAAAAAAAAAAAAAAAAAAEAAABQAAAAAAAAAAAA4D8AAAAAAADgPwAAAAAAAOA/AAAAAAAA4D8AAAAAAADgPwAAAAAAAOA/AAAAAAAA4D8AAAAAAADgPwAAAAAAAOA/AAAAAAAA4D8CAAAAjAAAAAAAAAAAAAAAQoX0DP///wgAAAAAAAAAAAAAAAAAAAAAAAAAAAAAAAAAAAAAZAAAAAEAAABAAAAAAAAAAAAAAAAAAAAAAAAAAAAAAAAAAAAAAAAAAAAAAAAAAAAAAAAAAAAAAAAAAAAAAAAAAAAAAAAAAAAAAAAAAAAAAAAAAAAAAAAAAAAAAAAAAAAAFAAAADwAAAAAAAAAAAAAAAAAAAkUAAAAAQAAABQAAAAUAAAAFAAAAAEAAAAAAAAAZAAAAGQAAAAAAAAAZAAAAGQAAAAVAAAAYAAAAAAAAAAAAAAADwAAACADAAAAAAAAAAAAAAEAAACgMgAAVgcAAKr4//8BAAAAf39/AAEAAABkAAAAAAAAABQAAABAHwAAAAAAACYAAAAAAAAAwOD//wAAAAAmAAAAZAAAABYAAABMAAAAAAAAAAAAAAAEAAAAAAAAAAEAAABZWVkKAAAAACgAAAAoAAAAZAAAAGQAAAAAAAAAzMzMAAAAAABQAAAAUAAAAGQAAABkAAAAAAAAABcAAAAUAAAAAAAAAAAAAAD/fwAA/38AAAAAAAAJAAAABAAAAAAAAAAeAAAAaAAAAAAAAAAAAAAAAAAAAAAAAAAAAAAAECcAABAnAAAAAAAAAAAAAAAAAAAAAAAAAAAAAAAAAAAAAAAAAAAAABQAAAAAAAAAwMD/AAAAAABkAAAAMgAAAAAAAABkAAAAAAAAAH9/fwAKAAAAIgAAABgAAAAAAAAAAAAAAAAAAAAAAAAAAAAAAAAAAAAkAAAAJAAAAAAAAAAHAAAAAAAAAAAAAAAAAAAAAAAAAAAAAAAAAAAAf39/ACUAAABYAAAAAAAAAAAAAAAAAAAAAAAAAAAAAAAAAAAAAAAAAAAAAAAAAAAAAAAAAAAAAAA/AAAAAAAAAKCGAQAAAAAAAAAAAAAAAAAMAAAAAQAAAAAAAAAAAAAAAAAAAB8AAABUAAAAAAAABQAAAAEAAAAAAAAAAAAAAAAAAAAAAAAAAAAAAAAAAAAAAAAAAAAAAAJ/f38AAAAAA8zMzADAwP8Af39/AAAAAAAAAAAAAAAAAAAAAAAAAAAAIQAAABgAAAAUAAAAFAMAANkKAABSHgAAMCcAABAAAAAmAAAACAAAAD2wAAAAAAAA"/>
+                <pr:smNativeData xmlns:pr="smNativeData" xmlns="smNativeData" val="SMDATA_15_FUV5ZhMAAAAlAAAAZAAAAA0AAAAAkAAAAJAAAACQAAAAkAAAAAAAAAAAAAAAAAAAAAEAAABQAAAAAAAAAAAA4D8AAAAAAADgPwAAAAAAAOA/AAAAAAAA4D8AAAAAAADgPwAAAAAAAOA/AAAAAAAA4D8AAAAAAADgPwAAAAAAAOA/AAAAAAAA4D8CAAAAjAAAAAAAAAAAAAAAQoX0DP///wgAAAAAAAAAAAAAAAAAAAAAAAAAAAAAAAAAAAAAZAAAAAEAAABAAAAAAAAAAAAAAAAAAAAAAAAAAAAAAAAAAAAAAAAAAAAAAAAAAAAAAAAAAAAAAAAAAAAAAAAAAAAAAAAAAAAAAAAAAAAAAAAAAAAAAAAAAAAAAAAAAAAAFAAAADwAAAAAAAAAAAAAAAAAAAkUAAAAAQAAABQAAAAUAAAAFAAAAAEAAAAAAAAAZAAAAGQAAAAAAAAAZAAAAGQAAAAVAAAAYAAAAAAAAAAAAAAADwAAACADAAAAAAAAAAAAAAEAAACgMgAAVgcAAKr4//8BAAAAf39/AAEAAABkAAAAAAAAABQAAABAHwAAAAAAACYAAAAAAAAAwOD//wAAAAAmAAAAZAAAABYAAABMAAAAAAAAAAAAAAAEAAAAAAAAAAEAAABZWVkKAAAAACgAAAAoAAAAZAAAAGQAAAAAAAAAzMzMAAAAAABQAAAAUAAAAGQAAABkAAAAAAAAABcAAAAUAAAAAAAAAAAAAAD/fwAA/38AAAAAAAAJAAAABAAAAAAAAAAeAAAAaAAAAAAAAAAAAAAAAAAAAAAAAAAAAAAAECcAABAnAAAAAAAAAAAAAAAAAAAAAAAAAAAAAAAAAAAAAAAAAAAAABQAAAAAAAAAwMD/AAAAAABkAAAAMgAAAAAAAABkAAAAAAAAAH9/fwAKAAAAIgAAABgAAAAAAAAAAAAAAAAAAAAAAAAAAAAAAAAAAAAkAAAAJAAAAAAAAAAHAAAAAAAAAAAAAAAAAAAAAAAAAAAAAAAAAAAAf39/ACUAAABYAAAAAAAAAAAAAAAAAAAAAAAAAAAAAAAAAAAAAAAAAAAAAAAAAAAAAAAAAAAAAAA/AAAAAAAAAKCGAQAAAAAAAAAAAAAAAAAMAAAAAQAAAAAAAAAAAAAAAAAAAB8AAABUAAAAAAAABQAAAAEAAAAAAAAAAAAAAAAAAAAAAAAAAAAAAAAAAAAAAAAAAAAAAAJ/f38AAAAAA8zMzADAwP8Af39/AAAAAAAAAAAAAAAAAAAAAAAAAAAAIQAAABgAAAAUAAAAFAMAANkKAABSHgAAMCcAABAAAAAmAAAACAAAAD2wAAAAAAAA"/>
               </a:ext>
             </a:extLst>
           </p:cNvSpPr>
@@ -4106,7 +4106,7 @@
             <a:spLocks noGrp="1" noChangeArrowheads="1"/>
             <a:extLst>
               <a:ext uri="smNativeData">
-                <pr:smNativeData xmlns:pr="smNativeData" xmlns="smNativeData" val="SMDATA_15_LkR5ZhMAAAAlAAAAZAAAAA0AAAAAkAAAAJAAAACQAAAAkAAAAAAAAAAAAAAAAAAAAAEAAABQAAAAAAAAAAAA4D8AAAAAAADgPwAAAAAAAOA/AAAAAAAA4D8AAAAAAADgPwAAAAAAAOA/AAAAAAAA4D8AAAAAAADgPwAAAAAAAOA/AAAAAAAA4D8CAAAAjAAAAAAAAAAAAAAAQoX0DP///wgAAAAAAAAAAAAAAAAAAAAAAAAAAAAAAAAAAAAAZAAAAAEAAABAAAAAAAAAAAAAAAAAAAAAAAAAAAAAAAAAAAAAAAAAAAAAAAAAAAAAAAAAAAAAAAAAAAAAAAAAAAAAAAAAAAAAAAAAAAAAAAAAAAAAAAAAAAAAAAAAAAAAFAAAADwAAAAAAAAAAAAAAAAAAAkUAAAAAQAAABQAAAAUAAAAFAAAAAEAAAAAAAAAZAAAAGQAAAAAAAAAZAAAAGQAAAAVAAAAYAAAAAAAAAAAAAAADwAAACADAAAAAAAAAAAAAAEAAACgMgAAVgcAAKr4//8BAAAAf39/AAEAAABkAAAAAAAAABQAAABAHwAAAAAAACYAAAAAAAAAwOD//wAAAAAmAAAAZAAAABYAAABMAAAAAAAAAAAAAAAEAAAAAAAAAAEAAABZWVkKAAAAACgAAAAoAAAAZAAAAGQAAAAAAAAAzMzMAAAAAABQAAAAUAAAAGQAAABkAAAAAAAAABcAAAAUAAAAAAAAAAAAAAD/fwAA/38AAAAAAAAJAAAABAAAAAAAAAAeAAAAaAAAAAAAAAAAAAAAAAAAAAAAAAAAAAAAECcAABAnAAAAAAAAAAAAAAAAAAAAAAAAAAAAAAAAAAAAAAAAAAAAABQAAAAAAAAAwMD/AAAAAABkAAAAMgAAAAAAAABkAAAAAAAAAH9/fwAKAAAAIgAAABgAAAAAAAAAAAAAAAAAAAAAAAAAAAAAAAAAAAAkAAAAJAAAAAAAAAAHAAAAAAAAAAAAAAAAAAAAAAAAAAAAAAAAAAAAf39/ACUAAABYAAAAAAAAAAAAAAAAAAAAAAAAAAAAAAAAAAAAAAAAAAAAAAAAAAAAAAAAAAAAAAA/AAAAAAAAAKCGAQAAAAAAAAAAAAAAAAAMAAAAAQAAAAAAAAAAAAAAAAAAAB8AAABUAAAAAAAABQAAAAEAAAAAAAAAAAAAAAAAAAAAAAAAAAAAAAAAAAAAAAAAAAAAAAJ/f38AAAAAA8zMzADAwP8Af39/AAAAAAAAAAAAAAAAAAAAAAAAAAAAIQAAABgAAAAUAAAALCIAANkKAACPNQAAmCUAABAAAAAmAAAACAAAAD2wAAAAAAAA"/>
+                <pr:smNativeData xmlns:pr="smNativeData" xmlns="smNativeData" val="SMDATA_15_FUV5ZhMAAAAlAAAAZAAAAA0AAAAAkAAAAJAAAACQAAAAkAAAAAAAAAAAAAAAAAAAAAEAAABQAAAAAAAAAAAA4D8AAAAAAADgPwAAAAAAAOA/AAAAAAAA4D8AAAAAAADgPwAAAAAAAOA/AAAAAAAA4D8AAAAAAADgPwAAAAAAAOA/AAAAAAAA4D8CAAAAjAAAAAAAAAAAAAAAQoX0DP///wgAAAAAAAAAAAAAAAAAAAAAAAAAAAAAAAAAAAAAZAAAAAEAAABAAAAAAAAAAAAAAAAAAAAAAAAAAAAAAAAAAAAAAAAAAAAAAAAAAAAAAAAAAAAAAAAAAAAAAAAAAAAAAAAAAAAAAAAAAAAAAAAAAAAAAAAAAAAAAAAAAAAAFAAAADwAAAAAAAAAAAAAAAAAAAkUAAAAAQAAABQAAAAUAAAAFAAAAAEAAAAAAAAAZAAAAGQAAAAAAAAAZAAAAGQAAAAVAAAAYAAAAAAAAAAAAAAADwAAACADAAAAAAAAAAAAAAEAAACgMgAAVgcAAKr4//8BAAAAf39/AAEAAABkAAAAAAAAABQAAABAHwAAAAAAACYAAAAAAAAAwOD//wAAAAAmAAAAZAAAABYAAABMAAAAAAAAAAAAAAAEAAAAAAAAAAEAAABZWVkKAAAAACgAAAAoAAAAZAAAAGQAAAAAAAAAzMzMAAAAAABQAAAAUAAAAGQAAABkAAAAAAAAABcAAAAUAAAAAAAAAAAAAAD/fwAA/38AAAAAAAAJAAAABAAAAAAAAAAeAAAAaAAAAAAAAAAAAAAAAAAAAAAAAAAAAAAAECcAABAnAAAAAAAAAAAAAAAAAAAAAAAAAAAAAAAAAAAAAAAAAAAAABQAAAAAAAAAwMD/AAAAAABkAAAAMgAAAAAAAABkAAAAAAAAAH9/fwAKAAAAIgAAABgAAAAAAAAAAAAAAAAAAAAAAAAAAAAAAAAAAAAkAAAAJAAAAAAAAAAHAAAAAAAAAAAAAAAAAAAAAAAAAAAAAAAAAAAAf39/ACUAAABYAAAAAAAAAAAAAAAAAAAAAAAAAAAAAAAAAAAAAAAAAAAAAAAAAAAAAAAAAAAAAAA/AAAAAAAAAKCGAQAAAAAAAAAAAAAAAAAMAAAAAQAAAAAAAAAAAAAAAAAAAB8AAABUAAAAAAAABQAAAAEAAAAAAAAAAAAAAAAAAAAAAAAAAAAAAAAAAAAAAAAAAAAAAAJ/f38AAAAAA8zMzADAwP8Af39/AAAAAAAAAAAAAAAAAAAAAAAAAAAAIQAAABgAAAAUAAAALCIAANkKAACPNQAAmCUAABAAAAAmAAAACAAAAD2wAAAAAAAA"/>
               </a:ext>
             </a:extLst>
           </p:cNvSpPr>
@@ -4318,7 +4318,7 @@
             <a:spLocks noGrp="1" noChangeArrowheads="1"/>
             <a:extLst>
               <a:ext uri="smNativeData">
-                <pr:smNativeData xmlns:pr="smNativeData" xmlns="smNativeData" val="SMDATA_15_LkR5ZhMAAAAlAAAAZAAAAA0AAAAAkAAAAJAAAACQAAAAkAAAAAAAAAABAAAAAAAAAAEAAABQAAAAAAAAAAAA4D8AAAAAAADgPwAAAAAAAOA/AAAAAAAA4D8AAAAAAADgPwAAAAAAAOA/AAAAAAAA4D8AAAAAAADgPwAAAAAAAOA/AAAAAAAA4D8CAAAAjAAAAAAAAAAAAAAAQoX0DP///wgAAAAAAAAAAAAAAAAAAAAAAAAAAAAAAAAAAAAAZAAAAAEAAABAAAAAAAAAAAAAAAAAAAAAAAAAAAAAAAAAAAAAAAAAAAAAAAAAAAAAAAAAAAAAAAAAAAAAAAAAAAAAAAAAAAAAAAAAAAAAAAAAAAAAAAAAAAAAAAAAAAAAFAAAADwAAAAAAAAAAAAAAAAAAAkUAAAAAQAAABQAAAAUAAAAFAAAAAEAAAAAAAAAZAAAAGQAAAAAAAAAZAAAAGQAAAAVAAAAYAAAAAAAAAAAAAAADwAAACADAAAAAAAAAAAAAAEAAACgMgAAVgcAAKr4//8BAAAAf39/AAEAAABkAAAAAAAAABQAAABAHwAAAAAAACYAAAAAAAAAwOD//wAAAAAmAAAAZAAAABYAAABMAAAAAAAAAAAAAAAEAAAAAAAAAAEAAABZWVkKAAAAACgAAAAoAAAAZAAAAGQAAAAAAAAAzMzMAAAAAABQAAAAUAAAAGQAAABkAAAAAAAAABcAAAAUAAAAAAAAAAAAAAD/fwAA/38AAAAAAAAJAAAABAAAAAAAAAAeAAAAaAAAAAAAAAAAAAAAAAAAAAAAAAAAAAAAECcAABAnAAAAAAAAAAAAAAAAAAAAAAAAAAAAAAAAAAAAAAAAAAAAABQAAAAAAAAAwMD/AAAAAABkAAAAMgAAAAAAAABkAAAAAAAAAH9/fwAKAAAAIgAAABgAAAAAAAAAAAAAAAAAAAAAAAAAAAAAAAAAAAAkAAAAJAAAAAAAAAAHAAAAAAAAAAAAAAAAAAAAAAAAAAAAAAAAAAAAf39/ACUAAABYAAAAAAAAAAAAAAAAAAAAAAAAAAAAAAAAAAAAAAAAAAAAAAAAAAAAAAAAAAAAAAA/AAAAAAAAAKCGAQAAAAAAAAAAAAAAAAAMAAAAAQAAAAAAAAAAAAAAAAAAAB8AAABUAAAAAAAABQAAAAEAAAAAAAAAAAAAAAAAAAAAAAAAAAAAAAAAAAAAAAAAAAAAAAJ/f38AAAAAA8zMzADAwP8Af39/AAAAAAAAAAAAAAAAAAAAAAAAAAAAIQAAABgAAAAUAAAAFAMAAEoPAADlMwAAMhYAABAAAAAmAAAACAAAAL2wAAAAAAAA"/>
+                <pr:smNativeData xmlns:pr="smNativeData" xmlns="smNativeData" val="SMDATA_15_FUV5ZhMAAAAlAAAAZAAAAA0AAAAAkAAAAJAAAACQAAAAkAAAAAAAAAABAAAAAAAAAAEAAABQAAAAAAAAAAAA4D8AAAAAAADgPwAAAAAAAOA/AAAAAAAA4D8AAAAAAADgPwAAAAAAAOA/AAAAAAAA4D8AAAAAAADgPwAAAAAAAOA/AAAAAAAA4D8CAAAAjAAAAAAAAAAAAAAAQoX0DP///wgAAAAAAAAAAAAAAAAAAAAAAAAAAAAAAAAAAAAAZAAAAAEAAABAAAAAAAAAAAAAAAAAAAAAAAAAAAAAAAAAAAAAAAAAAAAAAAAAAAAAAAAAAAAAAAAAAAAAAAAAAAAAAAAAAAAAAAAAAAAAAAAAAAAAAAAAAAAAAAAAAAAAFAAAADwAAAAAAAAAAAAAAAAAAAkUAAAAAQAAABQAAAAUAAAAFAAAAAEAAAAAAAAAZAAAAGQAAAAAAAAAZAAAAGQAAAAVAAAAYAAAAAAAAAAAAAAADwAAACADAAAAAAAAAAAAAAEAAACgMgAAVgcAAKr4//8BAAAAf39/AAEAAABkAAAAAAAAABQAAABAHwAAAAAAACYAAAAAAAAAwOD//wAAAAAmAAAAZAAAABYAAABMAAAAAAAAAAAAAAAEAAAAAAAAAAEAAABZWVkKAAAAACgAAAAoAAAAZAAAAGQAAAAAAAAAzMzMAAAAAABQAAAAUAAAAGQAAABkAAAAAAAAABcAAAAUAAAAAAAAAAAAAAD/fwAA/38AAAAAAAAJAAAABAAAAAAAAAAeAAAAaAAAAAAAAAAAAAAAAAAAAAAAAAAAAAAAECcAABAnAAAAAAAAAAAAAAAAAAAAAAAAAAAAAAAAAAAAAAAAAAAAABQAAAAAAAAAwMD/AAAAAABkAAAAMgAAAAAAAABkAAAAAAAAAH9/fwAKAAAAIgAAABgAAAAAAAAAAAAAAAAAAAAAAAAAAAAAAAAAAAAkAAAAJAAAAAAAAAAHAAAAAAAAAAAAAAAAAAAAAAAAAAAAAAAAAAAAf39/ACUAAABYAAAAAAAAAAAAAAAAAAAAAAAAAAAAAAAAAAAAAAAAAAAAAAAAAAAAAAAAAAAAAAA/AAAAAAAAAKCGAQAAAAAAAAAAAAAAAAAMAAAAAQAAAAAAAAAAAAAAAAAAAB8AAABUAAAAAAAABQAAAAEAAAAAAAAAAAAAAAAAAAAAAAAAAAAAAAAAAAAAAAAAAAAAAAJ/f38AAAAAA8zMzADAwP8Af39/AAAAAAAAAAAAAAAAAAAAAAAAAAAAIQAAABgAAAAUAAAAFAMAAEoPAADlMwAAMhYAABAAAAAmAAAACAAAAL2wAAAAAAAA"/>
               </a:ext>
             </a:extLst>
           </p:cNvSpPr>
@@ -4442,7 +4442,7 @@
             <a:spLocks noGrp="1" noChangeArrowheads="1"/>
             <a:extLst>
               <a:ext uri="smNativeData">
-                <pr:smNativeData xmlns:pr="smNativeData" xmlns="smNativeData" val="SMDATA_15_LkR5ZhMAAAAlAAAAZAAAAA0AAAAAkAAAAJAAAACQAAAAkAAAAAAAAAABAAAAAAAAAAEAAABQAAAAAAAAAAAA4D8AAAAAAADgPwAAAAAAAOA/AAAAAAAA4D8AAAAAAADgPwAAAAAAAOA/AAAAAAAA4D8AAAAAAADgPwAAAAAAAOA/AAAAAAAA4D8CAAAAjAAAAAAAAAAAAAAAQoX0DP///wgAAAAAAAAAAAAAAAAAAAAAAAAAAAAAAAAAAAAAZAAAAAEAAABAAAAAAAAAAAAAAAAAAAAAAAAAAAAAAAAAAAAAAAAAAAAAAAAAAAAAAAAAAAAAAAAAAAAAAAAAAAAAAAAAAAAAAAAAAAAAAAAAAAAAAAAAAAAAAAAAAAAAFAAAADwAAAAAAAAAAAAAAAAAAAkUAAAAAQAAABQAAAAUAAAAFAAAAAEAAAAAAAAAZAAAAGQAAAAAAAAAZAAAAGQAAAAVAAAAYAAAAAAAAAAAAAAADwAAACADAAAAAAAAAAAAAAEAAACgMgAAVgcAAKr4//8BAAAAf39/AAEAAABkAAAAAAAAABQAAABAHwAAAAAAACYAAAAAAAAAwOD//wAAAAAmAAAAZAAAABYAAABMAAAAAAAAAAAAAAAEAAAAAAAAAAEAAABZWVkKAAAAACgAAAAoAAAAZAAAAGQAAAAAAAAAzMzMAAAAAABQAAAAUAAAAGQAAABkAAAAAAAAABcAAAAUAAAAAAAAAAAAAAD/fwAA/38AAAAAAAAJAAAABAAAAAAAAAAeAAAAaAAAAAAAAAAAAAAAAAAAAAAAAAAAAAAAECcAABAnAAAAAAAAAAAAAAAAAAAAAAAAAAAAAAAAAAAAAAAAAAAAABQAAAAAAAAAwMD/AAAAAABkAAAAMgAAAAAAAABkAAAAAAAAAH9/fwAKAAAAIgAAABgAAAAAAAAAAAAAAAAAAAAAAAAAAAAAAAAAAAAkAAAAJAAAAAAAAAAHAAAAAAAAAAAAAAAAAAAAAAAAAAAAAAAAAAAAf39/ACUAAABYAAAAAAAAAAAAAAAAAAAAAAAAAAAAAAAAAAAAAAAAAAAAAAAAAAAAAAAAAAAAAAA/AAAAAAAAAKCGAQAAAAAAAAAAAAAAAAAMAAAAAQAAAAAAAAAAAAAAAAAAAB8AAABUAAAAAAAABQAAAAEAAAAAAAAAAAAAAAAAAAAAAAAAAAAAAAAAAAAAAAAAAAAAAAJ/f38AAAAAA8zMzADAwP8Af39/AAAAAAAAAAAAAAAAAAAAAAAAAAAAIQAAABgAAAAUAAAAHjQAAEAmAAB/NwAAeikAABAAAAAmAAAACAAAADywAAAAAAAA"/>
+                <pr:smNativeData xmlns:pr="smNativeData" xmlns="smNativeData" val="SMDATA_15_FUV5ZhMAAAAlAAAAZAAAAA0AAAAAkAAAAJAAAACQAAAAkAAAAAAAAAABAAAAAAAAAAEAAABQAAAAAAAAAAAA4D8AAAAAAADgPwAAAAAAAOA/AAAAAAAA4D8AAAAAAADgPwAAAAAAAOA/AAAAAAAA4D8AAAAAAADgPwAAAAAAAOA/AAAAAAAA4D8CAAAAjAAAAAAAAAAAAAAAQoX0DP///wgAAAAAAAAAAAAAAAAAAAAAAAAAAAAAAAAAAAAAZAAAAAEAAABAAAAAAAAAAAAAAAAAAAAAAAAAAAAAAAAAAAAAAAAAAAAAAAAAAAAAAAAAAAAAAAAAAAAAAAAAAAAAAAAAAAAAAAAAAAAAAAAAAAAAAAAAAAAAAAAAAAAAFAAAADwAAAAAAAAAAAAAAAAAAAkUAAAAAQAAABQAAAAUAAAAFAAAAAEAAAAAAAAAZAAAAGQAAAAAAAAAZAAAAGQAAAAVAAAAYAAAAAAAAAAAAAAADwAAACADAAAAAAAAAAAAAAEAAACgMgAAVgcAAKr4//8BAAAAf39/AAEAAABkAAAAAAAAABQAAABAHwAAAAAAACYAAAAAAAAAwOD//wAAAAAmAAAAZAAAABYAAABMAAAAAAAAAAAAAAAEAAAAAAAAAAEAAABZWVkKAAAAACgAAAAoAAAAZAAAAGQAAAAAAAAAzMzMAAAAAABQAAAAUAAAAGQAAABkAAAAAAAAABcAAAAUAAAAAAAAAAAAAAD/fwAA/38AAAAAAAAJAAAABAAAAAAAAAAeAAAAaAAAAAAAAAAAAAAAAAAAAAAAAAAAAAAAECcAABAnAAAAAAAAAAAAAAAAAAAAAAAAAAAAAAAAAAAAAAAAAAAAABQAAAAAAAAAwMD/AAAAAABkAAAAMgAAAAAAAABkAAAAAAAAAH9/fwAKAAAAIgAAABgAAAAAAAAAAAAAAAAAAAAAAAAAAAAAAAAAAAAkAAAAJAAAAAAAAAAHAAAAAAAAAAAAAAAAAAAAAAAAAAAAAAAAAAAAf39/ACUAAABYAAAAAAAAAAAAAAAAAAAAAAAAAAAAAAAAAAAAAAAAAAAAAAAAAAAAAAAAAAAAAAA/AAAAAAAAAKCGAQAAAAAAAAAAAAAAAAAMAAAAAQAAAAAAAAAAAAAAAAAAAB8AAABUAAAAAAAABQAAAAEAAAAAAAAAAAAAAAAAAAAAAAAAAAAAAAAAAAAAAAAAAAAAAAJ/f38AAAAAA8zMzADAwP8Af39/AAAAAAAAAAAAAAAAAAAAAAAAAAAAIQAAABgAAAAUAAAAHjQAAEAmAAB/NwAAeikAABAAAAAmAAAACAAAADywAAAAAAAA"/>
               </a:ext>
             </a:extLst>
           </p:cNvSpPr>
@@ -4496,7 +4496,7 @@
               </a:spcAft>
               <a:buNone/>
             </a:pPr>
-            <a:fld id="{3FDAAAA4-EAD2-8F5C-9C62-1C09E42C6A49}" type="slidenum">
+            <a:fld id="{3FD97718-56D2-8C81-9C61-A0D4392F6AF5}" type="slidenum">
               <a:rPr lang="ru-ru" cap="none"/>
               <a:t/>
             </a:fld>
@@ -4537,7 +4537,7 @@
             <a:spLocks noGrp="1" noChangeArrowheads="1"/>
             <a:extLst>
               <a:ext uri="smNativeData">
-                <pr:smNativeData xmlns:pr="smNativeData" xmlns="smNativeData" val="SMDATA_15_LkR5ZhMAAAAlAAAAZAAAAA0AAAAAkAAAAJAAAACQAAAAkAAAAAAAAAAAAAAAAAAAAAEAAABQAAAAAAAAAAAA4D8AAAAAAADgPwAAAAAAAOA/AAAAAAAA4D8AAAAAAADgPwAAAAAAAOA/AAAAAAAA4D8AAAAAAADgPwAAAAAAAOA/AAAAAAAA4D8CAAAAjAAAAAAAAAAAAAAAQoX0DP///wgAAAAAAAAAAAAAAAAAAAAAAAAAAAAAAAAAAAAAZAAAAAEAAABAAAAAAAAAAAAAAAAAAAAAAAAAAAAAAAAAAAAAAAAAAAAAAAAAAAAAAAAAAAAAAAAAAAAAAAAAAAAAAAAAAAAAAAAAAAAAAAAAAAAAAAAAAAAAAAAAAAAAFAAAADwAAAAAAAAAAAAAAAAAAAkUAAAAAQAAABQAAAAUAAAAFAAAAAEAAAAAAAAAZAAAAGQAAAAAAAAAZAAAAGQAAAAVAAAAYAAAAAAAAAAAAAAADwAAACADAAAAAAAAAAAAAAEAAACgMgAAVgcAAKr4//8BAAAAf39/AAEAAABkAAAAAAAAABQAAABAHwAAAAAAACYAAAAAAAAAwOD//wAAAAAmAAAAZAAAABYAAABMAAAAAAAAAAAAAAAEAAAAAAAAAAEAAABZWVkKAAAAACgAAAAoAAAAZAAAAGQAAAAAAAAAzMzMAAAAAABQAAAAUAAAAGQAAABkAAAAAAAAABcAAAAUAAAAAAAAAAAAAAD/fwAA/38AAAAAAAAJAAAABAAAAMhrcwceAAAAaAAAAAAAAAAAAAAAAAAAAAAAAAAAAAAAECcAABAnAAAAAAAAAAAAAAAAAAAAAAAAAAAAAAAAAAAAAAAAAAAAABQAAAAAAAAAwMD/AAAAAABkAAAAMgAAAAAAAABkAAAAAAAAAH9/fwAKAAAAIgAAABgAAAAAAAAAAAAAAAAAAAAAAAAAAAAAAAAAAAAkAAAAJAAAAAAAAAAHAAAAAAAAAAAAAAAAAAAAAAAAAAAAAAAAAAAAf39/ACUAAABYAAAAAAAAAAAAAAAAAAAAAAAAAAAAAAAAAAAAAAAAAAAAAAAAAAAAAAAAAAAAAAA/AAAAAAAAAKCGAQAAAAAAAAAAAAAAAAAMAAAAAQAAAAAAAAAAAAAAAAAAAB8AAABUAAAAAAAABQAAAAEAAAAAAAAAAAAAAAAAAAAAAAAAAAAAAAAAAAAAAAAAAAAAAAJ/f38AAAAAA8zMzADAwP8Af39/AAAAAAAAAAAAAAAAAAAAAAAAAAAAIQAAABgAAAAUAAAAFAMAALYCAAB/NwAAvwoAABAAAAAmAAAACAAAADywAAAAAAAA"/>
+                <pr:smNativeData xmlns:pr="smNativeData" xmlns="smNativeData" val="SMDATA_15_FUV5ZhMAAAAlAAAAZAAAAA0AAAAAkAAAAJAAAACQAAAAkAAAAAAAAAAAAAAAAAAAAAEAAABQAAAAAAAAAAAA4D8AAAAAAADgPwAAAAAAAOA/AAAAAAAA4D8AAAAAAADgPwAAAAAAAOA/AAAAAAAA4D8AAAAAAADgPwAAAAAAAOA/AAAAAAAA4D8CAAAAjAAAAAAAAAAAAAAAQoX0DP///wgAAAAAAAAAAAAAAAAAAAAAAAAAAAAAAAAAAAAAZAAAAAEAAABAAAAAAAAAAAAAAAAAAAAAAAAAAAAAAAAAAAAAAAAAAAAAAAAAAAAAAAAAAAAAAAAAAAAAAAAAAAAAAAAAAAAAAAAAAAAAAAAAAAAAAAAAAAAAAAAAAAAAFAAAADwAAAAAAAAAAAAAAAAAAAkUAAAAAQAAABQAAAAUAAAAFAAAAAEAAAAAAAAAZAAAAGQAAAAAAAAAZAAAAGQAAAAVAAAAYAAAAAAAAAAAAAAADwAAACADAAAAAAAAAAAAAAEAAACgMgAAVgcAAKr4//8BAAAAf39/AAEAAABkAAAAAAAAABQAAABAHwAAAAAAACYAAAAAAAAAwOD//wAAAAAmAAAAZAAAABYAAABMAAAAAAAAAAAAAAAEAAAAAAAAAAEAAABZWVkKAAAAACgAAAAoAAAAZAAAAGQAAAAAAAAAzMzMAAAAAABQAAAAUAAAAGQAAABkAAAAAAAAABcAAAAUAAAAAAAAAAAAAAD/fwAA/38AAAAAAAAJAAAABAAAAMhrcwceAAAAaAAAAAAAAAAAAAAAAAAAAAAAAAAAAAAAECcAABAnAAAAAAAAAAAAAAAAAAAAAAAAAAAAAAAAAAAAAAAAAAAAABQAAAAAAAAAwMD/AAAAAABkAAAAMgAAAAAAAABkAAAAAAAAAH9/fwAKAAAAIgAAABgAAAAAAAAAAAAAAAAAAAAAAAAAAAAAAAAAAAAkAAAAJAAAAAAAAAAHAAAAAAAAAAAAAAAAAAAAAAAAAAAAAAAAAAAAf39/ACUAAABYAAAAAAAAAAAAAAAAAAAAAAAAAAAAAAAAAAAAAAAAAAAAAAAAAAAAAAAAAAAAAAA/AAAAAAAAAKCGAQAAAAAAAAAAAAAAAAAMAAAAAQAAAAAAAAAAAAAAAAAAAB8AAABUAAAAAAAABQAAAAEAAAAAAAAAAAAAAAAAAAAAAAAAAAAAAAAAAAAAAAAAAAAAAAJ/f38AAAAAA8zMzADAwP8Af39/AAAAAAAAAAAAAAAAAAAAAAAAAAAAIQAAABgAAAAUAAAAFAMAALYCAAB/NwAAvwoAABAAAAAmAAAACAAAADywAAAAAAAA"/>
               </a:ext>
             </a:extLst>
           </p:cNvSpPr>
@@ -4647,7 +4647,7 @@
             <a:spLocks noGrp="1" noChangeArrowheads="1"/>
             <a:extLst>
               <a:ext uri="smNativeData">
-                <pr:smNativeData xmlns:pr="smNativeData" xmlns="smNativeData" val="SMDATA_15_LkR5ZhMAAAAlAAAAZAAAAA0AAAAAkAAAAJAAAACQAAAAkAAAAAAAAAAAAAAAAAAAAAEAAABQAAAAAAAAAAAA4D8AAAAAAADgPwAAAAAAAOA/AAAAAAAA4D8AAAAAAADgPwAAAAAAAOA/AAAAAAAA4D8AAAAAAADgPwAAAAAAAOA/AAAAAAAA4D8CAAAAjAAAAAAAAAAAAAAAQoX0DP///wgAAAAAAAAAAAAAAAAAAAAAAAAAAAAAAAAAAAAAZAAAAAEAAABAAAAAAAAAAAAAAAAAAAAAAAAAAAAAAAAAAAAAAAAAAAAAAAAAAAAAAAAAAAAAAAAAAAAAAAAAAAAAAAAAAAAAAAAAAAAAAAAAAAAAAAAAAAAAAAAAAAAAFAAAADwAAAAAAAAAAAAAAAAAAAkUAAAAAQAAABQAAAAUAAAAFAAAAAEAAAAAAAAAZAAAAGQAAAAAAAAAZAAAAGQAAAAVAAAAYAAAAAAAAAAAAAAADwAAACADAAAAAAAAAAAAAAEAAACgMgAAVgcAAKr4//8BAAAAf39/AAEAAABkAAAAAAAAABQAAABAHwAAAAAAACYAAAAAAAAAwOD//wAAAAAmAAAAZAAAABYAAABMAAAAAAAAAAAAAAAEAAAAAAAAAAEAAABZWVkKAAAAACgAAAAoAAAAZAAAAGQAAAAAAAAAzMzMAAAAAABQAAAAUAAAAGQAAABkAAAAAAAAABcAAAAUAAAAAAAAAAAAAAD/fwAA/38AAAAAAAAJAAAABAAAAF8AYAAeAAAAaAAAAAAAAAAAAAAAAAAAAAAAAAAAAAAAECcAABAnAAAAAAAAAAAAAAAAAAAAAAAAAAAAAAAAAAAAAAAAAAAAABQAAAAAAAAAwMD/AAAAAABkAAAAMgAAAAAAAABkAAAAAAAAAH9/fwAKAAAAIgAAABgAAAAAAAAAAAAAAAAAAAAAAAAAAAAAAAAAAAAkAAAAJAAAAAAAAAAHAAAAAAAAAAAAAAAAAAAAAAAAAAAAAAAAAAAAf39/ACUAAABYAAAAAAAAAAAAAAAAAAAAAAAAAAAAAAAAAAAAAAAAAAAAAAAAAAAAAAAAAAAAAAA/AAAAAAAAAKCGAQAAAAAAAAAAAAAAAAAMAAAAAQAAAAAAAAAAAAAAAAAAAB8AAABUAAAAAAAABQAAAAEAAAAAAAAAAAAAAAAAAAAAAAAAAAAAAAAAAAAAAAAAAAAAAAJ/f38AAAAAA8zMzADAwP8Af39/AAAAAAAAAAAAAAAAAAAAAAAAAAAAIQAAABgAAAAUAAAAFAMAALMLAAB/NwAAuScAABAAAAAmAAAACAAAAD2wAAAAAAAA"/>
+                <pr:smNativeData xmlns:pr="smNativeData" xmlns="smNativeData" val="SMDATA_15_FUV5ZhMAAAAlAAAAZAAAAA0AAAAAkAAAAJAAAACQAAAAkAAAAAAAAAAAAAAAAAAAAAEAAABQAAAAAAAAAAAA4D8AAAAAAADgPwAAAAAAAOA/AAAAAAAA4D8AAAAAAADgPwAAAAAAAOA/AAAAAAAA4D8AAAAAAADgPwAAAAAAAOA/AAAAAAAA4D8CAAAAjAAAAAAAAAAAAAAAQoX0DP///wgAAAAAAAAAAAAAAAAAAAAAAAAAAAAAAAAAAAAAZAAAAAEAAABAAAAAAAAAAAAAAAAAAAAAAAAAAAAAAAAAAAAAAAAAAAAAAAAAAAAAAAAAAAAAAAAAAAAAAAAAAAAAAAAAAAAAAAAAAAAAAAAAAAAAAAAAAAAAAAAAAAAAFAAAADwAAAAAAAAAAAAAAAAAAAkUAAAAAQAAABQAAAAUAAAAFAAAAAEAAAAAAAAAZAAAAGQAAAAAAAAAZAAAAGQAAAAVAAAAYAAAAAAAAAAAAAAADwAAACADAAAAAAAAAAAAAAEAAACgMgAAVgcAAKr4//8BAAAAf39/AAEAAABkAAAAAAAAABQAAABAHwAAAAAAACYAAAAAAAAAwOD//wAAAAAmAAAAZAAAABYAAABMAAAAAAAAAAAAAAAEAAAAAAAAAAEAAABZWVkKAAAAACgAAAAoAAAAZAAAAGQAAAAAAAAAzMzMAAAAAABQAAAAUAAAAGQAAABkAAAAAAAAABcAAAAUAAAAAAAAAAAAAAD/fwAA/38AAAAAAAAJAAAABAAAAF8AYAAeAAAAaAAAAAAAAAAAAAAAAAAAAAAAAAAAAAAAECcAABAnAAAAAAAAAAAAAAAAAAAAAAAAAAAAAAAAAAAAAAAAAAAAABQAAAAAAAAAwMD/AAAAAABkAAAAMgAAAAAAAABkAAAAAAAAAH9/fwAKAAAAIgAAABgAAAAAAAAAAAAAAAAAAAAAAAAAAAAAAAAAAAAkAAAAJAAAAAAAAAAHAAAAAAAAAAAAAAAAAAAAAAAAAAAAAAAAAAAAf39/ACUAAABYAAAAAAAAAAAAAAAAAAAAAAAAAAAAAAAAAAAAAAAAAAAAAAAAAAAAAAAAAAAAAAA/AAAAAAAAAKCGAQAAAAAAAAAAAAAAAAAMAAAAAQAAAAAAAAAAAAAAAAAAAB8AAABUAAAAAAAABQAAAAEAAAAAAAAAAAAAAAAAAAAAAAAAAAAAAAAAAAAAAAAAAAAAAAJ/f38AAAAAA8zMzADAwP8Af39/AAAAAAAAAAAAAAAAAAAAAAAAAAAAIQAAABgAAAAUAAAAFAMAALMLAAB/NwAAuScAABAAAAAmAAAACAAAAD2wAAAAAAAA"/>
               </a:ext>
             </a:extLst>
           </p:cNvSpPr>
@@ -4798,7 +4798,7 @@
             <a:spLocks noGrp="1" noChangeArrowheads="1"/>
             <a:extLst>
               <a:ext uri="smNativeData">
-                <pr:smNativeData xmlns:pr="smNativeData" xmlns="smNativeData" val="SMDATA_15_LkR5ZhMAAAAlAAAAZAAAAA0AAAAAkAAAAJAAAACQAAAAkAAAAAAAAAABAAAAAAAAAAEAAABQAAAAAAAAAAAA4D8AAAAAAADgPwAAAAAAAOA/AAAAAAAA4D8AAAAAAADgPwAAAAAAAOA/AAAAAAAA4D8AAAAAAADgPwAAAAAAAOA/AAAAAAAA4D8CAAAAjAAAAAAAAAAAAAAAQoX0DP///wgAAAAAAAAAAAAAAAAAAAAAAAAAAAAAAAAAAAAAZAAAAAEAAABAAAAAAAAAAAAAAAAAAAAAAAAAAAAAAAAAAAAAAAAAAAAAAAAAAAAAAAAAAAAAAAAAAAAAAAAAAAAAAAAAAAAAAAAAAAAAAAAAAAAAAAAAAAAAAAAAAAAAFAAAADwAAAAAAAAAAAAAAAAAAAkUAAAAAQAAABQAAAAUAAAAFAAAAAEAAAAAAAAAZAAAAGQAAAAAAAAAZAAAAGQAAAAVAAAAYAAAAAAAAAAAAAAADwAAACADAAAAAAAAAAAAAAEAAACgMgAAVgcAAKr4//8BAAAAf39/AAEAAABkAAAAAAAAABQAAABAHwAAAAAAACYAAAAAAAAAwOD//wAAAAAmAAAAZAAAABYAAABMAAAAAAAAAAAAAAAEAAAAAAAAAAEAAABZWVkKAAAAACgAAAAoAAAAZAAAAGQAAAAAAAAAzMzMAAAAAABQAAAAUAAAAGQAAABkAAAAAAAAABcAAAAUAAAAAAAAAAAAAAD/fwAA/38AAAAAAAAJAAAABAAAAF8AYAAeAAAAaAAAAAAAAAAAAAAAAAAAAAAAAAAAAAAAECcAABAnAAAAAAAAAAAAAAAAAAAAAAAAAAAAAAAAAAAAAAAAAAAAABQAAAAAAAAAwMD/AAAAAABkAAAAMgAAAAAAAABkAAAAAAAAAH9/fwAKAAAAIgAAABgAAAAAAAAAAAAAAAAAAAAAAAAAAAAAAAAAAAAkAAAAJAAAAAAAAAAHAAAAAAAAAAAAAAAAAAAAAAAAAAAAAAAAAAAAf39/ACUAAABYAAAAAAAAAAAAAAAAAAAAAAAAAAAAAAAAAAAAAAAAAAAAAAAAAAAAAAAAAAAAAAA/AAAAAAAAAKCGAQAAAAAAAAAAAAAAAAAMAAAAAQAAAAAAAAAAAAAAAAAAAB8AAABUAAAAAAAABQAAAAEAAAAAAAAAAAAAAAAAAAAAAAAAAAAAAAAAAAAAAAAAAAAAAAJ/f38AAAAAA8zMzADAwP8Af39/AAAAAAAAAAAAAAAAAAAAAAAAAAAAIQAAABgAAAAUAAAAHjQAAEAmAAB/NwAAeikAABAAAAAmAAAACAAAADywAAAAAAAA"/>
+                <pr:smNativeData xmlns:pr="smNativeData" xmlns="smNativeData" val="SMDATA_15_FUV5ZhMAAAAlAAAAZAAAAA0AAAAAkAAAAJAAAACQAAAAkAAAAAAAAAABAAAAAAAAAAEAAABQAAAAAAAAAAAA4D8AAAAAAADgPwAAAAAAAOA/AAAAAAAA4D8AAAAAAADgPwAAAAAAAOA/AAAAAAAA4D8AAAAAAADgPwAAAAAAAOA/AAAAAAAA4D8CAAAAjAAAAAAAAAAAAAAAQoX0DP///wgAAAAAAAAAAAAAAAAAAAAAAAAAAAAAAAAAAAAAZAAAAAEAAABAAAAAAAAAAAAAAAAAAAAAAAAAAAAAAAAAAAAAAAAAAAAAAAAAAAAAAAAAAAAAAAAAAAAAAAAAAAAAAAAAAAAAAAAAAAAAAAAAAAAAAAAAAAAAAAAAAAAAFAAAADwAAAAAAAAAAAAAAAAAAAkUAAAAAQAAABQAAAAUAAAAFAAAAAEAAAAAAAAAZAAAAGQAAAAAAAAAZAAAAGQAAAAVAAAAYAAAAAAAAAAAAAAADwAAACADAAAAAAAAAAAAAAEAAACgMgAAVgcAAKr4//8BAAAAf39/AAEAAABkAAAAAAAAABQAAABAHwAAAAAAACYAAAAAAAAAwOD//wAAAAAmAAAAZAAAABYAAABMAAAAAAAAAAAAAAAEAAAAAAAAAAEAAABZWVkKAAAAACgAAAAoAAAAZAAAAGQAAAAAAAAAzMzMAAAAAABQAAAAUAAAAGQAAABkAAAAAAAAABcAAAAUAAAAAAAAAAAAAAD/fwAA/38AAAAAAAAJAAAABAAAAF8AYAAeAAAAaAAAAAAAAAAAAAAAAAAAAAAAAAAAAAAAECcAABAnAAAAAAAAAAAAAAAAAAAAAAAAAAAAAAAAAAAAAAAAAAAAABQAAAAAAAAAwMD/AAAAAABkAAAAMgAAAAAAAABkAAAAAAAAAH9/fwAKAAAAIgAAABgAAAAAAAAAAAAAAAAAAAAAAAAAAAAAAAAAAAAkAAAAJAAAAAAAAAAHAAAAAAAAAAAAAAAAAAAAAAAAAAAAAAAAAAAAf39/ACUAAABYAAAAAAAAAAAAAAAAAAAAAAAAAAAAAAAAAAAAAAAAAAAAAAAAAAAAAAAAAAAAAAA/AAAAAAAAAKCGAQAAAAAAAAAAAAAAAAAMAAAAAQAAAAAAAAAAAAAAAAAAAB8AAABUAAAAAAAABQAAAAEAAAAAAAAAAAAAAAAAAAAAAAAAAAAAAAAAAAAAAAAAAAAAAAJ/f38AAAAAA8zMzADAwP8Af39/AAAAAAAAAAAAAAAAAAAAAAAAAAAAIQAAABgAAAAUAAAAHjQAAEAmAAB/NwAAeikAABAAAAAmAAAACAAAADywAAAAAAAA"/>
               </a:ext>
             </a:extLst>
           </p:cNvSpPr>
@@ -4852,7 +4852,7 @@
               </a:spcAft>
               <a:buNone/>
             </a:pPr>
-            <a:fld id="{3FDAC551-1FD2-8F33-9C62-E9668B2C6ABC}" type="slidenum">
+            <a:fld id="{3FD90F26-68D2-8CF9-9C61-9EAC412F6ACB}" type="slidenum">
               <a:rPr lang="ru-ru" cap="none"/>
               <a:t/>
             </a:fld>
@@ -4893,7 +4893,7 @@
             <a:spLocks noGrp="1" noChangeArrowheads="1"/>
             <a:extLst>
               <a:ext uri="smNativeData">
-                <pr:smNativeData xmlns:pr="smNativeData" xmlns="smNativeData" val="SMDATA_15_LkR5ZhMAAAAlAAAAZAAAAA0AAAAAkAAAAJAAAACQAAAAkAAAAAAAAAABAAAAAAAAAAEAAABQAAAAAAAAAAAA4D8AAAAAAADgPwAAAAAAAOA/AAAAAAAA4D8AAAAAAADgPwAAAAAAAOA/AAAAAAAA4D8AAAAAAADgPwAAAAAAAOA/AAAAAAAA4D8CAAAAjAAAAAAAAAAAAAAAQoX0DP///wgAAAAAAAAAAAAAAAAAAAAAAAAAAAAAAAAAAAAAZAAAAAEAAABAAAAAAAAAAAAAAAAAAAAAAAAAAAAAAAAAAAAAAAAAAAAAAAAAAAAAAAAAAAAAAAAAAAAAAAAAAAAAAAAAAAAAAAAAAAAAAAAAAAAAAAAAAAAAAAAAAAAAFAAAADwAAAAAAAAAAAAAAAAAAAkUAAAAAQAAABQAAAAUAAAAFAAAAAEAAAAAAAAAZAAAAGQAAAAAAAAAZAAAAGQAAAAVAAAAYAAAAAAAAAAAAAAADwAAACADAAAAAAAAAAAAAAEAAACgMgAAVgcAAKr4//8BAAAAf39/AAEAAABkAAAAAAAAABQAAABAHwAAAAAAACYAAAAAAAAAwOD//wAAAAAmAAAAZAAAABYAAABMAAAAAAAAAAAAAAAEAAAAAAAAAAEAAABZWVkKAAAAACgAAAAoAAAAZAAAAGQAAAAAAAAAzMzMAAAAAABQAAAAUAAAAGQAAABkAAAAAAAAABcAAAAUAAAAAAAAAAAAAAD/fwAA/38AAAAAAAAJAAAABAAAAAAAAAAeAAAAaAAAAAAAAAAAAAAAAAAAAAAAAAAAAAAAECcAABAnAAAAAAAAAAAAAAAAAAAAAAAAAAAAAAAAAAAAAAAAAAAAABQAAAAAAAAAwMD/AAAAAABkAAAAMgAAAAAAAABkAAAAAAAAAH9/fwAKAAAAIgAAABgAAAAAAAAAAAAAAAAAAAAAAAAAAAAAAAAAAAAkAAAAJAAAAAAAAAAHAAAAAAAAAAAAAAAAAAAAAAAAAAAAAAAAAAAAf39/ACUAAABYAAAAAAAAAAAAAAAAAAAAAAAAAAAAAAAAAAAAAAAAAAAAAAAAAAAAAAAAAAAAAAA/AAAAAAAAAKCGAQAAAAAAAAAAAAAAAAAMAAAAAQAAAAAAAAAAAAAAAAAAAB8AAABUAAAAAAAABQAAAAEAAAAAAAAAAAAAAAAAAAAAAAAAAAAAAAAAAAAAAAAAAAAAAAJ/f38AAAAAA8zMzADAwP8Af39/AAAAAAAAAAAAAAAAAAAAAAAAAAAAIQAAABgAAAAUAAAAHjQAAEAmAAB/NwAAeikAABAAAAAmAAAACAAAADywAAAAAAAA"/>
+                <pr:smNativeData xmlns:pr="smNativeData" xmlns="smNativeData" val="SMDATA_15_FUV5ZhMAAAAlAAAAZAAAAA0AAAAAkAAAAJAAAACQAAAAkAAAAAAAAAABAAAAAAAAAAEAAABQAAAAAAAAAAAA4D8AAAAAAADgPwAAAAAAAOA/AAAAAAAA4D8AAAAAAADgPwAAAAAAAOA/AAAAAAAA4D8AAAAAAADgPwAAAAAAAOA/AAAAAAAA4D8CAAAAjAAAAAAAAAAAAAAAQoX0DP///wgAAAAAAAAAAAAAAAAAAAAAAAAAAAAAAAAAAAAAZAAAAAEAAABAAAAAAAAAAAAAAAAAAAAAAAAAAAAAAAAAAAAAAAAAAAAAAAAAAAAAAAAAAAAAAAAAAAAAAAAAAAAAAAAAAAAAAAAAAAAAAAAAAAAAAAAAAAAAAAAAAAAAFAAAADwAAAAAAAAAAAAAAAAAAAkUAAAAAQAAABQAAAAUAAAAFAAAAAEAAAAAAAAAZAAAAGQAAAAAAAAAZAAAAGQAAAAVAAAAYAAAAAAAAAAAAAAADwAAACADAAAAAAAAAAAAAAEAAACgMgAAVgcAAKr4//8BAAAAf39/AAEAAABkAAAAAAAAABQAAABAHwAAAAAAACYAAAAAAAAAwOD//wAAAAAmAAAAZAAAABYAAABMAAAAAAAAAAAAAAAEAAAAAAAAAAEAAABZWVkKAAAAACgAAAAoAAAAZAAAAGQAAAAAAAAAzMzMAAAAAABQAAAAUAAAAGQAAABkAAAAAAAAABcAAAAUAAAAAAAAAAAAAAD/fwAA/38AAAAAAAAJAAAABAAAAAAAAAAeAAAAaAAAAAAAAAAAAAAAAAAAAAAAAAAAAAAAECcAABAnAAAAAAAAAAAAAAAAAAAAAAAAAAAAAAAAAAAAAAAAAAAAABQAAAAAAAAAwMD/AAAAAABkAAAAMgAAAAAAAABkAAAAAAAAAH9/fwAKAAAAIgAAABgAAAAAAAAAAAAAAAAAAAAAAAAAAAAAAAAAAAAkAAAAJAAAAAAAAAAHAAAAAAAAAAAAAAAAAAAAAAAAAAAAAAAAAAAAf39/ACUAAABYAAAAAAAAAAAAAAAAAAAAAAAAAAAAAAAAAAAAAAAAAAAAAAAAAAAAAAAAAAAAAAA/AAAAAAAAAKCGAQAAAAAAAAAAAAAAAAAMAAAAAQAAAAAAAAAAAAAAAAAAAB8AAABUAAAAAAAABQAAAAEAAAAAAAAAAAAAAAAAAAAAAAAAAAAAAAAAAAAAAAAAAAAAAAJ/f38AAAAAA8zMzADAwP8Af39/AAAAAAAAAAAAAAAAAAAAAAAAAAAAIQAAABgAAAAUAAAAHjQAAEAmAAB/NwAAeikAABAAAAAmAAAACAAAADywAAAAAAAA"/>
               </a:ext>
             </a:extLst>
           </p:cNvSpPr>
@@ -4947,7 +4947,7 @@
               </a:spcAft>
               <a:buNone/>
             </a:pPr>
-            <a:fld id="{3FDAC90C-42D2-8F3F-9C62-B46A872C6AE1}" type="slidenum">
+            <a:fld id="{3FD92FB5-FBD2-8CD9-9C61-0D8C612F6A58}" type="slidenum">
               <a:rPr lang="ru-ru" cap="none"/>
               <a:t/>
             </a:fld>
@@ -4962,7 +4962,7 @@
             <a:spLocks noGrp="1" noChangeArrowheads="1"/>
             <a:extLst>
               <a:ext uri="smNativeData">
-                <pr:smNativeData xmlns:pr="smNativeData" xmlns="smNativeData" val="SMDATA_15_LkR5ZhMAAAAlAAAAZAAAAA0AAAAAkAAAAJAAAACQAAAAkAAAAAAAAAAAAAAAAAAAAAEAAABQAAAAAAAAAAAA4D8AAAAAAADgPwAAAAAAAOA/AAAAAAAA4D8AAAAAAADgPwAAAAAAAOA/AAAAAAAA4D8AAAAAAADgPwAAAAAAAOA/AAAAAAAA4D8CAAAAjAAAAAAAAAAAAAAAQoX0DP///wgAAAAAAAAAAAAAAAAAAAAAAAAAAAAAAAAAAAAAZAAAAAEAAABAAAAAAAAAAAAAAAAAAAAAAAAAAAAAAAAAAAAAAAAAAAAAAAAAAAAAAAAAAAAAAAAAAAAAAAAAAAAAAAAAAAAAAAAAAAAAAAAAAAAAAAAAAAAAAAAAAAAAFAAAADwAAAAAAAAAAAAAAAAAAAkUAAAAAQAAABQAAAAUAAAAFAAAAAEAAAAAAAAAZAAAAGQAAAAAAAAAZAAAAGQAAAAVAAAAYAAAAAAAAAAAAAAADwAAACADAAAAAAAAAAAAAAEAAACgMgAAVgcAAKr4//8BAAAAf39/AAEAAABkAAAAAAAAABQAAABAHwAAAAAAACYAAAAAAAAAwOD//wAAAAAmAAAAZAAAABYAAABMAAAAAAAAAAAAAAAEAAAAAAAAAAEAAABZWVkKAAAAACgAAAAoAAAAZAAAAGQAAAAAAAAAzMzMAAAAAABQAAAAUAAAAGQAAABkAAAAAAAAABcAAAAUAAAAAAAAAAAAAAD/fwAA/38AAAAAAAAJAAAABAAAAF0AXgAeAAAAaAAAAAAAAAAAAAAAAAAAAAAAAAAAAAAAECcAABAnAAAAAAAAAAAAAAAAAAAAAAAAAAAAAAAAAAAAAAAAAAAAABQAAAAAAAAAwMD/AAAAAABkAAAAMgAAAAAAAABkAAAAAAAAAH9/fwAKAAAAIgAAABgAAAAAAAAAAAAAAAAAAAAAAAAAAAAAAAAAAAAkAAAAJAAAAAAAAAAHAAAAAAAAAAAAAAAAAAAAAAAAAAAAAAAAAAAAf39/ACUAAABYAAAAAAAAAAAAAAAAAAAAAAAAAAAAAAAAAAAAAAAAAAAAAAAAAAAAAAAAAAAAAAA/AAAAAAAAAKCGAQAAAAAAAAAAAAAAAAAMAAAAAQAAAAAAAAAAAAAAAAAAAB8AAABUAAAAAAAABQAAAAEAAAAAAAAAAAAAAAAAAAAAAAAAAAAAAAAAAAAAAAAAAAAAAAJ/f38AAAAAA8zMzADAwP8Af39/AAAAAAAAAAAAAAAAAAAAAAAAAAAAIQAAABgAAAAUAAAAFAMAALwGAAB/NwAAARcAABAAAAAmAAAACAAAAD2wAAAAAAAA"/>
+                <pr:smNativeData xmlns:pr="smNativeData" xmlns="smNativeData" val="SMDATA_15_FUV5ZhMAAAAlAAAAZAAAAA0AAAAAkAAAAJAAAACQAAAAkAAAAAAAAAAAAAAAAAAAAAEAAABQAAAAAAAAAAAA4D8AAAAAAADgPwAAAAAAAOA/AAAAAAAA4D8AAAAAAADgPwAAAAAAAOA/AAAAAAAA4D8AAAAAAADgPwAAAAAAAOA/AAAAAAAA4D8CAAAAjAAAAAAAAAAAAAAAQoX0DP///wgAAAAAAAAAAAAAAAAAAAAAAAAAAAAAAAAAAAAAZAAAAAEAAABAAAAAAAAAAAAAAAAAAAAAAAAAAAAAAAAAAAAAAAAAAAAAAAAAAAAAAAAAAAAAAAAAAAAAAAAAAAAAAAAAAAAAAAAAAAAAAAAAAAAAAAAAAAAAAAAAAAAAFAAAADwAAAAAAAAAAAAAAAAAAAkUAAAAAQAAABQAAAAUAAAAFAAAAAEAAAAAAAAAZAAAAGQAAAAAAAAAZAAAAGQAAAAVAAAAYAAAAAAAAAAAAAAADwAAACADAAAAAAAAAAAAAAEAAACgMgAAVgcAAKr4//8BAAAAf39/AAEAAABkAAAAAAAAABQAAABAHwAAAAAAACYAAAAAAAAAwOD//wAAAAAmAAAAZAAAABYAAABMAAAAAAAAAAAAAAAEAAAAAAAAAAEAAABZWVkKAAAAACgAAAAoAAAAZAAAAGQAAAAAAAAAzMzMAAAAAABQAAAAUAAAAGQAAABkAAAAAAAAABcAAAAUAAAAAAAAAAAAAAD/fwAA/38AAAAAAAAJAAAABAAAAF0AXgAeAAAAaAAAAAAAAAAAAAAAAAAAAAAAAAAAAAAAECcAABAnAAAAAAAAAAAAAAAAAAAAAAAAAAAAAAAAAAAAAAAAAAAAABQAAAAAAAAAwMD/AAAAAABkAAAAMgAAAAAAAABkAAAAAAAAAH9/fwAKAAAAIgAAABgAAAAAAAAAAAAAAAAAAAAAAAAAAAAAAAAAAAAkAAAAJAAAAAAAAAAHAAAAAAAAAAAAAAAAAAAAAAAAAAAAAAAAAAAAf39/ACUAAABYAAAAAAAAAAAAAAAAAAAAAAAAAAAAAAAAAAAAAAAAAAAAAAAAAAAAAAAAAAAAAAA/AAAAAAAAAKCGAQAAAAAAAAAAAAAAAAAMAAAAAQAAAAAAAAAAAAAAAAAAAB8AAABUAAAAAAAABQAAAAEAAAAAAAAAAAAAAAAAAAAAAAAAAAAAAAAAAAAAAAAAAAAAAAJ/f38AAAAAA8zMzADAwP8Af39/AAAAAAAAAAAAAAAAAAAAAAAAAAAAIQAAABgAAAAUAAAAFAMAALwGAAB/NwAAARcAABAAAAAmAAAACAAAAD2wAAAAAAAA"/>
               </a:ext>
             </a:extLst>
           </p:cNvSpPr>
@@ -5078,7 +5078,7 @@
             <a:spLocks noGrp="1" noChangeArrowheads="1"/>
             <a:extLst>
               <a:ext uri="smNativeData">
-                <pr:smNativeData xmlns:pr="smNativeData" xmlns="smNativeData" val="SMDATA_15_LkR5ZhMAAAAlAAAAZAAAAA0AAAAAkAAAAJAAAACQAAAAkAAAAAAAAAAAAAAAAAAAAAEAAABQAAAAAAAAAAAA4D8AAAAAAADgPwAAAAAAAOA/AAAAAAAA4D8AAAAAAADgPwAAAAAAAOA/AAAAAAAA4D8AAAAAAADgPwAAAAAAAOA/AAAAAAAA4D8CAAAAjAAAAAAAAAAAAAAAQoX0DP///wgAAAAAAAAAAAAAAAAAAAAAAAAAAAAAAAAAAAAAZAAAAAEAAABAAAAAAAAAAAAAAAAAAAAAAAAAAAAAAAAAAAAAAAAAAAAAAAAAAAAAAAAAAAAAAAAAAAAAAAAAAAAAAAAAAAAAAAAAAAAAAAAAAAAAAAAAAAAAAAAAAAAAFAAAADwAAAAAAAAAAAAAAAAAAAkUAAAAAQAAABQAAAAUAAAAFAAAAAEAAAAAAAAAZAAAAGQAAAAAAAAAZAAAAGQAAAAVAAAAYAAAAAAAAAAAAAAADwAAACADAAAAAAAAAAAAAAEAAACgMgAAVgcAAKr4//8BAAAAf39/AAEAAABkAAAAAAAAABQAAABAHwAAAAAAACYAAAAAAAAAwOD//wAAAAAmAAAAZAAAABYAAABMAAAAAAAAAAAAAAAEAAAAAAAAAAEAAABZWVkKAAAAACgAAAAoAAAAZAAAAGQAAAAAAAAAzMzMAAAAAABQAAAAUAAAAGQAAABkAAAAAAAAABcAAAAUAAAAAAAAAAAAAAD/fwAA/38AAAAAAAAJAAAABAAAAAAAAAAeAAAAaAAAAAAAAAAAAAAAAAAAAAAAAAAAAAAAECcAABAnAAAAAAAAAAAAAAAAAAAAAAAAAAAAAAAAAAAAAAAAAAAAABQAAAAAAAAAwMD/AAAAAABkAAAAMgAAAAAAAABkAAAAAAAAAH9/fwAKAAAAIgAAABgAAAAAAAAAAAAAAAAAAAAAAAAAAAAAAAAAAAAkAAAAJAAAAAAAAAAHAAAAAAAAAAAAAAAAAAAAAAAAAAAAAAAAAAAAf39/ACUAAABYAAAAAAAAAAAAAAAAAAAAAAAAAAAAAAAAAAAAAAAAAAAAAAAAAAAAAAAAAAAAAAA/AAAAAAAAAKCGAQAAAAAAAAAAAAAAAAAMAAAAAQAAAAAAAAAAAAAAAAAAAB8AAABUAAAAAAAABQAAAAEAAAAAAAAAAAAAAAAAAAAAAAAAAAAAAAAAAAAAAAAAAAAAAAJ/f38AAAAAA8zMzADAwP8Af39/AAAAAAAAAAAAAAAAAAAAAAAAAAAAIQAAABgAAAAUAAAAFAMAAMADAAALMwAAQQoAABAAAAAmAAAACAAAAD2wAAAAAAAA"/>
+                <pr:smNativeData xmlns:pr="smNativeData" xmlns="smNativeData" val="SMDATA_15_FUV5ZhMAAAAlAAAAZAAAAA0AAAAAkAAAAJAAAACQAAAAkAAAAAAAAAAAAAAAAAAAAAEAAABQAAAAAAAAAAAA4D8AAAAAAADgPwAAAAAAAOA/AAAAAAAA4D8AAAAAAADgPwAAAAAAAOA/AAAAAAAA4D8AAAAAAADgPwAAAAAAAOA/AAAAAAAA4D8CAAAAjAAAAAAAAAAAAAAAQoX0DP///wgAAAAAAAAAAAAAAAAAAAAAAAAAAAAAAAAAAAAAZAAAAAEAAABAAAAAAAAAAAAAAAAAAAAAAAAAAAAAAAAAAAAAAAAAAAAAAAAAAAAAAAAAAAAAAAAAAAAAAAAAAAAAAAAAAAAAAAAAAAAAAAAAAAAAAAAAAAAAAAAAAAAAFAAAADwAAAAAAAAAAAAAAAAAAAkUAAAAAQAAABQAAAAUAAAAFAAAAAEAAAAAAAAAZAAAAGQAAAAAAAAAZAAAAGQAAAAVAAAAYAAAAAAAAAAAAAAADwAAACADAAAAAAAAAAAAAAEAAACgMgAAVgcAAKr4//8BAAAAf39/AAEAAABkAAAAAAAAABQAAABAHwAAAAAAACYAAAAAAAAAwOD//wAAAAAmAAAAZAAAABYAAABMAAAAAAAAAAAAAAAEAAAAAAAAAAEAAABZWVkKAAAAACgAAAAoAAAAZAAAAGQAAAAAAAAAzMzMAAAAAABQAAAAUAAAAGQAAABkAAAAAAAAABcAAAAUAAAAAAAAAAAAAAD/fwAA/38AAAAAAAAJAAAABAAAAAAAAAAeAAAAaAAAAAAAAAAAAAAAAAAAAAAAAAAAAAAAECcAABAnAAAAAAAAAAAAAAAAAAAAAAAAAAAAAAAAAAAAAAAAAAAAABQAAAAAAAAAwMD/AAAAAABkAAAAMgAAAAAAAABkAAAAAAAAAH9/fwAKAAAAIgAAABgAAAAAAAAAAAAAAAAAAAAAAAAAAAAAAAAAAAAkAAAAJAAAAAAAAAAHAAAAAAAAAAAAAAAAAAAAAAAAAAAAAAAAAAAAf39/ACUAAABYAAAAAAAAAAAAAAAAAAAAAAAAAAAAAAAAAAAAAAAAAAAAAAAAAAAAAAAAAAAAAAA/AAAAAAAAAKCGAQAAAAAAAAAAAAAAAAAMAAAAAQAAAAAAAAAAAAAAAAAAAB8AAABUAAAAAAAABQAAAAEAAAAAAAAAAAAAAAAAAAAAAAAAAAAAAAAAAAAAAAAAAAAAAAJ/f38AAAAAA8zMzADAwP8Af39/AAAAAAAAAAAAAAAAAAAAAAAAAAAAIQAAABgAAAAUAAAAFAMAAMADAAALMwAAQQoAABAAAAAmAAAACAAAAD2wAAAAAAAA"/>
               </a:ext>
             </a:extLst>
           </p:cNvSpPr>
@@ -5265,7 +5265,7 @@
             <a:spLocks noGrp="1" noChangeArrowheads="1"/>
             <a:extLst>
               <a:ext uri="smNativeData">
-                <pr:smNativeData xmlns:pr="smNativeData" xmlns="smNativeData" val="SMDATA_15_LkR5ZhMAAAAlAAAAZAAAAA0AAAAAkAAAAJAAAACQAAAAkAAAAAAAAAAAAAAAAAAAAAEAAABQAAAAAAAAAAAA4D8AAAAAAADgPwAAAAAAAOA/AAAAAAAA4D8AAAAAAADgPwAAAAAAAOA/AAAAAAAA4D8AAAAAAADgPwAAAAAAAOA/AAAAAAAA4D8CAAAAjAAAAAAAAAAAAAAAQoX0DP///wgAAAAAAAAAAAAAAAAAAAAAAAAAAAAAAAAAAAAAZAAAAAEAAABAAAAAAAAAAAAAAAAAAAAAAAAAAAAAAAAAAAAAAAAAAAAAAAAAAAAAAAAAAAAAAAAAAAAAAAAAAAAAAAAAAAAAAAAAAAAAAAAAAAAAAAAAAAAAAAAAAAAAFAAAADwAAAAAAAAAAAAAAAAAAAkUAAAAAQAAABQAAAAUAAAAFAAAAAEAAAAAAAAAZAAAAGQAAAAAAAAAZAAAAGQAAAAVAAAAYAAAAAAAAAAAAAAADwAAACADAAAAAAAAAAAAAAEAAACgMgAAVgcAAKr4//8BAAAAf39/AAEAAABkAAAAAAAAABQAAABAHwAAAAAAACYAAAAAAAAAwOD//wAAAAAmAAAAZAAAABYAAABMAAAAAAAAAAAAAAAEAAAAAAAAAAEAAABZWVkKAAAAACgAAAAoAAAAZAAAAGQAAAAAAAAAzMzMAAAAAABQAAAAUAAAAGQAAABkAAAAAAAAABcAAAAUAAAAAAAAAAAAAAD/fwAA/38AAAAAAAAJAAAABAAAAAAAAAAeAAAAaAAAAAAAAAAAAAAAAAAAAAAAAAAAAAAAECcAABAnAAAAAAAAAAAAAAAAAAAAAAAAAAAAAAAAAAAAAAAAAAAAABQAAAAAAAAAwMD/AAAAAABkAAAAMgAAAAAAAABkAAAAAAAAAH9/fwAKAAAAIgAAABgAAAAAAAAAAAAAAAAAAAAAAAAAAAAAAAAAAAAkAAAAJAAAAAAAAAAHAAAAAAAAAAAAAAAAAAAAAAAAAAAAAAAAAAAAf39/ACUAAABYAAAAAAAAAAAAAAAAAAAAAAAAAAAAAAAAAAAAAAAAAAAAAAAAAAAAAAAAAAAAAAA/AAAAAAAAAKCGAQAAAAAAAAAAAAAAAAAMAAAAAQAAAAAAAAAAAAAAAAAAAB8AAABUAAAAAAAABQAAAAEAAAAAAAAAAAAAAAAAAAAAAAAAAAAAAAAAAAAAAAAAAAAAAAJ/f38AAAAAA8zMzADAwP8Af39/AAAAAAAAAAAAAAAAAAAAAAAAAAAAIQAAABgAAAAUAAAAShMAAK8ZAABQNwAAgB4AABAAAAAmAAAACAAAAD2wAAAAAAAA"/>
+                <pr:smNativeData xmlns:pr="smNativeData" xmlns="smNativeData" val="SMDATA_15_FUV5ZhMAAAAlAAAAZAAAAA0AAAAAkAAAAJAAAACQAAAAkAAAAAAAAAAAAAAAAAAAAAEAAABQAAAAAAAAAAAA4D8AAAAAAADgPwAAAAAAAOA/AAAAAAAA4D8AAAAAAADgPwAAAAAAAOA/AAAAAAAA4D8AAAAAAADgPwAAAAAAAOA/AAAAAAAA4D8CAAAAjAAAAAAAAAAAAAAAQoX0DP///wgAAAAAAAAAAAAAAAAAAAAAAAAAAAAAAAAAAAAAZAAAAAEAAABAAAAAAAAAAAAAAAAAAAAAAAAAAAAAAAAAAAAAAAAAAAAAAAAAAAAAAAAAAAAAAAAAAAAAAAAAAAAAAAAAAAAAAAAAAAAAAAAAAAAAAAAAAAAAAAAAAAAAFAAAADwAAAAAAAAAAAAAAAAAAAkUAAAAAQAAABQAAAAUAAAAFAAAAAEAAAAAAAAAZAAAAGQAAAAAAAAAZAAAAGQAAAAVAAAAYAAAAAAAAAAAAAAADwAAACADAAAAAAAAAAAAAAEAAACgMgAAVgcAAKr4//8BAAAAf39/AAEAAABkAAAAAAAAABQAAABAHwAAAAAAACYAAAAAAAAAwOD//wAAAAAmAAAAZAAAABYAAABMAAAAAAAAAAAAAAAEAAAAAAAAAAEAAABZWVkKAAAAACgAAAAoAAAAZAAAAGQAAAAAAAAAzMzMAAAAAABQAAAAUAAAAGQAAABkAAAAAAAAABcAAAAUAAAAAAAAAAAAAAD/fwAA/38AAAAAAAAJAAAABAAAAAAAAAAeAAAAaAAAAAAAAAAAAAAAAAAAAAAAAAAAAAAAECcAABAnAAAAAAAAAAAAAAAAAAAAAAAAAAAAAAAAAAAAAAAAAAAAABQAAAAAAAAAwMD/AAAAAABkAAAAMgAAAAAAAABkAAAAAAAAAH9/fwAKAAAAIgAAABgAAAAAAAAAAAAAAAAAAAAAAAAAAAAAAAAAAAAkAAAAJAAAAAAAAAAHAAAAAAAAAAAAAAAAAAAAAAAAAAAAAAAAAAAAf39/ACUAAABYAAAAAAAAAAAAAAAAAAAAAAAAAAAAAAAAAAAAAAAAAAAAAAAAAAAAAAAAAAAAAAA/AAAAAAAAAKCGAQAAAAAAAAAAAAAAAAAMAAAAAQAAAAAAAAAAAAAAAAAAAB8AAABUAAAAAAAABQAAAAEAAAAAAAAAAAAAAAAAAAAAAAAAAAAAAAAAAAAAAAAAAAAAAAJ/f38AAAAAA8zMzADAwP8Af39/AAAAAAAAAAAAAAAAAAAAAAAAAAAAIQAAABgAAAAUAAAAShMAAK8ZAABQNwAAgB4AABAAAAAmAAAACAAAAD2wAAAAAAAA"/>
               </a:ext>
             </a:extLst>
           </p:cNvSpPr>
@@ -5452,7 +5452,7 @@
             <a:spLocks noGrp="1" noChangeArrowheads="1"/>
             <a:extLst>
               <a:ext uri="smNativeData">
-                <pr:smNativeData xmlns:pr="smNativeData" xmlns="smNativeData" val="SMDATA_15_LkR5ZhMAAAAlAAAAZAAAAA0AAAAAkAAAAJAAAACQAAAAkAAAAAAAAAAAAAAAAAAAAAEAAABQAAAAAAAAAAAA4D8AAAAAAADgPwAAAAAAAOA/AAAAAAAA4D8AAAAAAADgPwAAAAAAAOA/AAAAAAAA4D8AAAAAAADgPwAAAAAAAOA/AAAAAAAA4D8CAAAAjAAAAAAAAAAAAAAAQoX0DP///wgAAAAAAAAAAAAAAAAAAAAAAAAAAAAAAAAAAAAAZAAAAAEAAABAAAAAAAAAAAAAAAAAAAAAAAAAAAAAAAAAAAAAAAAAAAAAAAAAAAAAAAAAAAAAAAAAAAAAAAAAAAAAAAAAAAAAAAAAAAAAAAAAAAAAAAAAAAAAAAAAAAAAFAAAADwAAAAAAAAAAAAAAAAAAAkUAAAAAQAAABQAAAAUAAAAFAAAAAEAAAAAAAAAZAAAAGQAAAAAAAAAZAAAAGQAAAAVAAAAYAAAAAAAAAAAAAAADwAAACADAAAAAAAAAAAAAAEAAACgMgAAVgcAAKr4//8BAAAAf39/AAEAAABkAAAAAAAAABQAAABAHwAAAAAAACYAAAAAAAAAwOD//wAAAAAmAAAAZAAAABYAAABMAAAAAAAAAAAAAAAEAAAAAAAAAAEAAABZWVkKAAAAACgAAAAoAAAAZAAAAGQAAAAAAAAAzMzMAAAAAABQAAAAUAAAAGQAAABkAAAAAAAAABcAAAAUAAAAAAAAAAAAAAD/fwAA/38AAAAAAAAJAAAABAAAAADvvg8eAAAAaAAAAAAAAAAAAAAAAAAAAAAAAAAAAAAAECcAABAnAAAAAAAAAAAAAAAAAAAAAAAAAAAAAAAAAAAAAAAAAAAAABQAAAAAAAAAwMD/AAAAAABkAAAAMgAAAAAAAABkAAAAAAAAAH9/fwAKAAAAIgAAABgAAAAAAAAAAAAAAAAAAAAAAAAAAAAAAAAAAAAkAAAAJAAAAAAAAAAHAAAAAAAAAAAAAAAAAAAAAAAAAAAAAAAAAAAAf39/ACUAAABYAAAAAAAAAAAAAAAAAAAAAAAAAAAAAAAAAAAAAAAAAAAAAAAAAAAAAAAAAAAAAAA/AAAAAAAAAKCGAQAAAAAAAAAAAAAAAAAMAAAAAQAAAAAAAAAAAAAAAAAAAB8AAABUAAAAAAAABQAAAAEAAAAAAAAAAAAAAAAAAAAAAAAAAAAAAAAAAAAAAAAAAAAAAAJ/f38AAAAAA8zMzADAwP8Af39/AAAAAAAAAAAAAAAAAAAAAAAAAAAAIQAAABgAAAAUAAAAShMAACUcAABQNwAApSIAABAAAAAmAAAACAAAAD2wAAAAAAAA"/>
+                <pr:smNativeData xmlns:pr="smNativeData" xmlns="smNativeData" val="SMDATA_15_FUV5ZhMAAAAlAAAAZAAAAA0AAAAAkAAAAJAAAACQAAAAkAAAAAAAAAAAAAAAAAAAAAEAAABQAAAAAAAAAAAA4D8AAAAAAADgPwAAAAAAAOA/AAAAAAAA4D8AAAAAAADgPwAAAAAAAOA/AAAAAAAA4D8AAAAAAADgPwAAAAAAAOA/AAAAAAAA4D8CAAAAjAAAAAAAAAAAAAAAQoX0DP///wgAAAAAAAAAAAAAAAAAAAAAAAAAAAAAAAAAAAAAZAAAAAEAAABAAAAAAAAAAAAAAAAAAAAAAAAAAAAAAAAAAAAAAAAAAAAAAAAAAAAAAAAAAAAAAAAAAAAAAAAAAAAAAAAAAAAAAAAAAAAAAAAAAAAAAAAAAAAAAAAAAAAAFAAAADwAAAAAAAAAAAAAAAAAAAkUAAAAAQAAABQAAAAUAAAAFAAAAAEAAAAAAAAAZAAAAGQAAAAAAAAAZAAAAGQAAAAVAAAAYAAAAAAAAAAAAAAADwAAACADAAAAAAAAAAAAAAEAAACgMgAAVgcAAKr4//8BAAAAf39/AAEAAABkAAAAAAAAABQAAABAHwAAAAAAACYAAAAAAAAAwOD//wAAAAAmAAAAZAAAABYAAABMAAAAAAAAAAAAAAAEAAAAAAAAAAEAAABZWVkKAAAAACgAAAAoAAAAZAAAAGQAAAAAAAAAzMzMAAAAAABQAAAAUAAAAGQAAABkAAAAAAAAABcAAAAUAAAAAAAAAAAAAAD/fwAA/38AAAAAAAAJAAAABAAAAADvvg8eAAAAaAAAAAAAAAAAAAAAAAAAAAAAAAAAAAAAECcAABAnAAAAAAAAAAAAAAAAAAAAAAAAAAAAAAAAAAAAAAAAAAAAABQAAAAAAAAAwMD/AAAAAABkAAAAMgAAAAAAAABkAAAAAAAAAH9/fwAKAAAAIgAAABgAAAAAAAAAAAAAAAAAAAAAAAAAAAAAAAAAAAAkAAAAJAAAAAAAAAAHAAAAAAAAAAAAAAAAAAAAAAAAAAAAAAAAAAAAf39/ACUAAABYAAAAAAAAAAAAAAAAAAAAAAAAAAAAAAAAAAAAAAAAAAAAAAAAAAAAAAAAAAAAAAA/AAAAAAAAAKCGAQAAAAAAAAAAAAAAAAAMAAAAAQAAAAAAAAAAAAAAAAAAAB8AAABUAAAAAAAABQAAAAEAAAAAAAAAAAAAAAAAAAAAAAAAAAAAAAAAAAAAAAAAAAAAAAJ/f38AAAAAA8zMzADAwP8Af39/AAAAAAAAAAAAAAAAAAAAAAAAAAAAIQAAABgAAAAUAAAAShMAACUcAABQNwAApSIAABAAAAAmAAAACAAAAD2wAAAAAAAA"/>
               </a:ext>
             </a:extLst>
           </p:cNvSpPr>
@@ -5639,7 +5639,7 @@
             <a:spLocks noGrp="1" noChangeArrowheads="1"/>
             <a:extLst>
               <a:ext uri="smNativeData">
-                <pr:smNativeData xmlns:pr="smNativeData" xmlns="smNativeData" val="SMDATA_15_LkR5ZhMAAAAlAAAAZAAAAA0AAAAAkAAAAJAAAACQAAAAkAAAAAAAAAAAAAAAAAAAAAEAAABQAAAAAAAAAAAA4D8AAAAAAADgPwAAAAAAAOA/AAAAAAAA4D8AAAAAAADgPwAAAAAAAOA/AAAAAAAA4D8AAAAAAADgPwAAAAAAAOA/AAAAAAAA4D8CAAAAjAAAAAAAAAAAAAAAQoX0DP///wgAAAAAAAAAAAAAAAAAAAAAAAAAAAAAAAAAAAAAZAAAAAEAAABAAAAAAAAAAAAAAAAAAAAAAAAAAAAAAAAAAAAAAAAAAAAAAAAAAAAAAAAAAAAAAAAAAAAAAAAAAAAAAAAAAAAAAAAAAAAAAAAAAAAAAAAAAAAAAAAAAAAAFAAAADwAAAAAAAAAAAAAAAAAAAkUAAAAAQAAABQAAAAUAAAAFAAAAAEAAAAAAAAAZAAAAGQAAAAAAAAAZAAAAGQAAAAVAAAAYAAAAAAAAAAAAAAADwAAACADAAAAAAAAAAAAAAEAAACgMgAAVgcAAKr4//8BAAAAf39/AAEAAABkAAAAAAAAABQAAABAHwAAAAAAACYAAAAAAAAAwOD//wAAAAAmAAAAZAAAABYAAABMAAAAAAAAAAAAAAAEAAAAAAAAAAEAAABZWVkKAAAAACgAAAAoAAAAZAAAAGQAAAAAAAAAzMzMAAAAAABQAAAAUAAAAGQAAABkAAAAAAAAABcAAAAUAAAAAAAAAAAAAAD/fwAA/38AAAAAAAAJAAAABAAAAIAmcwceAAAAaAAAAAAAAAAAAAAAAAAAAAAAAAAAAAAAECcAABAnAAAAAAAAAAAAAAAAAAAAAAAAAAAAAAAAAAAAAAAAAAAAABQAAAAAAAAAwMD/AAAAAABkAAAAMgAAAAAAAABkAAAAAAAAAH9/fwAKAAAAIgAAABgAAAAAAAAAAAAAAAAAAAAAAAAAAAAAAAAAAAAkAAAAJAAAAAAAAAAHAAAAAAAAAAAAAAAAAAAAAAAAAAAAAAAAAAAAf39/ACUAAABYAAAAAAAAAAAAAAAAAAAAAAAAAAAAAAAAAAAAAAAAAAAAAAAAAAAAAAAAAAAAAAA/AAAAAAAAAKCGAQAAAAAAAAAAAAAAAAAMAAAAAQAAAAAAAAAAAAAAAAAAAB8AAABUAAAAAAAABQAAAAEAAAAAAAAAAAAAAAAAAAAAAAAAAAAAAAAAAAAAAAAAAAAAAAJ/f38AAAAAA8zMzADAwP8Af39/AAAAAAAAAAAAAAAAAAAAAAAAAAAAIQAAABgAAAAUAAAAShMAAEofAABQNwAAwycAABAAAAAmAAAACAAAAD2wAAAAAAAA"/>
+                <pr:smNativeData xmlns:pr="smNativeData" xmlns="smNativeData" val="SMDATA_15_FUV5ZhMAAAAlAAAAZAAAAA0AAAAAkAAAAJAAAACQAAAAkAAAAAAAAAAAAAAAAAAAAAEAAABQAAAAAAAAAAAA4D8AAAAAAADgPwAAAAAAAOA/AAAAAAAA4D8AAAAAAADgPwAAAAAAAOA/AAAAAAAA4D8AAAAAAADgPwAAAAAAAOA/AAAAAAAA4D8CAAAAjAAAAAAAAAAAAAAAQoX0DP///wgAAAAAAAAAAAAAAAAAAAAAAAAAAAAAAAAAAAAAZAAAAAEAAABAAAAAAAAAAAAAAAAAAAAAAAAAAAAAAAAAAAAAAAAAAAAAAAAAAAAAAAAAAAAAAAAAAAAAAAAAAAAAAAAAAAAAAAAAAAAAAAAAAAAAAAAAAAAAAAAAAAAAFAAAADwAAAAAAAAAAAAAAAAAAAkUAAAAAQAAABQAAAAUAAAAFAAAAAEAAAAAAAAAZAAAAGQAAAAAAAAAZAAAAGQAAAAVAAAAYAAAAAAAAAAAAAAADwAAACADAAAAAAAAAAAAAAEAAACgMgAAVgcAAKr4//8BAAAAf39/AAEAAABkAAAAAAAAABQAAABAHwAAAAAAACYAAAAAAAAAwOD//wAAAAAmAAAAZAAAABYAAABMAAAAAAAAAAAAAAAEAAAAAAAAAAEAAABZWVkKAAAAACgAAAAoAAAAZAAAAGQAAAAAAAAAzMzMAAAAAABQAAAAUAAAAGQAAABkAAAAAAAAABcAAAAUAAAAAAAAAAAAAAD/fwAA/38AAAAAAAAJAAAABAAAAIAmcwceAAAAaAAAAAAAAAAAAAAAAAAAAAAAAAAAAAAAECcAABAnAAAAAAAAAAAAAAAAAAAAAAAAAAAAAAAAAAAAAAAAAAAAABQAAAAAAAAAwMD/AAAAAABkAAAAMgAAAAAAAABkAAAAAAAAAH9/fwAKAAAAIgAAABgAAAAAAAAAAAAAAAAAAAAAAAAAAAAAAAAAAAAkAAAAJAAAAAAAAAAHAAAAAAAAAAAAAAAAAAAAAAAAAAAAAAAAAAAAf39/ACUAAABYAAAAAAAAAAAAAAAAAAAAAAAAAAAAAAAAAAAAAAAAAAAAAAAAAAAAAAAAAAAAAAA/AAAAAAAAAKCGAQAAAAAAAAAAAAAAAAAMAAAAAQAAAAAAAAAAAAAAAAAAAB8AAABUAAAAAAAABQAAAAEAAAAAAAAAAAAAAAAAAAAAAAAAAAAAAAAAAAAAAAAAAAAAAAJ/f38AAAAAA8zMzADAwP8Af39/AAAAAAAAAAAAAAAAAAAAAAAAAAAAIQAAABgAAAAUAAAAShMAAEofAABQNwAAwycAABAAAAAmAAAACAAAAD2wAAAAAAAA"/>
               </a:ext>
             </a:extLst>
           </p:cNvSpPr>
@@ -5852,7 +5852,7 @@
             <a:spLocks noGrp="1" noChangeArrowheads="1"/>
             <a:extLst>
               <a:ext uri="smNativeData">
-                <pr:smNativeData xmlns:pr="smNativeData" xmlns="smNativeData" val="SMDATA_15_LkR5ZhMAAAAlAAAAZAAAAA0AAAAAkAAAAJAAAACQAAAAkAAAAAAAAAABAAAAAAAAAAEAAABQAAAAAAAAAAAA4D8AAAAAAADgPwAAAAAAAOA/AAAAAAAA4D8AAAAAAADgPwAAAAAAAOA/AAAAAAAA4D8AAAAAAADgPwAAAAAAAOA/AAAAAAAA4D8CAAAAjAAAAAAAAAAAAAAAQoX0DP///wgAAAAAAAAAAAAAAAAAAAAAAAAAAAAAAAAAAAAAZAAAAAEAAABAAAAAAAAAAAAAAAAAAAAAAAAAAAAAAAAAAAAAAAAAAAAAAAAAAAAAAAAAAAAAAAAAAAAAAAAAAAAAAAAAAAAAAAAAAAAAAAAAAAAAAAAAAAAAAAAAAAAAFAAAADwAAAAAAAAAAAAAAAAAAAkUAAAAAQAAABQAAAAUAAAAFAAAAAEAAAAAAAAAZAAAAGQAAAAAAAAAZAAAAGQAAAAVAAAAYAAAAAAAAAAAAAAADwAAACADAAAAAAAAAAAAAAEAAACgMgAAVgcAAKr4//8BAAAAf39/AAEAAABkAAAAAAAAABQAAABAHwAAAAAAACYAAAAAAAAAwOD//wAAAAAmAAAAZAAAABYAAABMAAAAAAAAAAAAAAAEAAAAAAAAAAEAAABZWVkKAAAAACgAAAAoAAAAZAAAAGQAAAAAAAAAzMzMAAAAAABQAAAAUAAAAGQAAABkAAAAAAAAABcAAAAUAAAAAAAAAAAAAAD/fwAA/38AAAAAAAAJAAAABAAAAF8AYAAeAAAAaAAAAAAAAAAAAAAAAAAAAAAAAAAAAAAAECcAABAnAAAAAAAAAAAAAAAAAAAAAAAAAAAAAAAAAAAAAAAAAAAAABQAAAAAAAAAwMD/AAAAAABkAAAAMgAAAAAAAABkAAAAAAAAAH9/fwAKAAAAIgAAABgAAAAAAAAAAAAAAAAAAAAAAAAAAAAAAAAAAAAkAAAAJAAAAAAAAAAHAAAAAAAAAAAAAAAAAAAAAAAAAAAAAAAAAAAAf39/ACUAAABYAAAAAAAAAAAAAAAAAAAAAAAAAAAAAAAAAAAAAAAAAAAAAAAAAAAAAAAAAAAAAAA/AAAAAAAAAKCGAQAAAAAAAAAAAAAAAAAMAAAAAQAAAAAAAAAAAAAAAAAAAB8AAABUAAAAAAAABQAAAAEAAAAAAAAAAAAAAAAAAAAAAAAAAAAAAAAAAAAAAAAAAAAAAAJ/f38AAAAAA8zMzADAwP8Af39/AAAAAAAAAAAAAAAAAAAAAAAAAAAAIQAAABgAAAAUAAAAHjQAAEAmAAB/NwAAeikAABAAAAAmAAAACAAAADywAAAAAAAA"/>
+                <pr:smNativeData xmlns:pr="smNativeData" xmlns="smNativeData" val="SMDATA_15_FUV5ZhMAAAAlAAAAZAAAAA0AAAAAkAAAAJAAAACQAAAAkAAAAAAAAAABAAAAAAAAAAEAAABQAAAAAAAAAAAA4D8AAAAAAADgPwAAAAAAAOA/AAAAAAAA4D8AAAAAAADgPwAAAAAAAOA/AAAAAAAA4D8AAAAAAADgPwAAAAAAAOA/AAAAAAAA4D8CAAAAjAAAAAAAAAAAAAAAQoX0DP///wgAAAAAAAAAAAAAAAAAAAAAAAAAAAAAAAAAAAAAZAAAAAEAAABAAAAAAAAAAAAAAAAAAAAAAAAAAAAAAAAAAAAAAAAAAAAAAAAAAAAAAAAAAAAAAAAAAAAAAAAAAAAAAAAAAAAAAAAAAAAAAAAAAAAAAAAAAAAAAAAAAAAAFAAAADwAAAAAAAAAAAAAAAAAAAkUAAAAAQAAABQAAAAUAAAAFAAAAAEAAAAAAAAAZAAAAGQAAAAAAAAAZAAAAGQAAAAVAAAAYAAAAAAAAAAAAAAADwAAACADAAAAAAAAAAAAAAEAAACgMgAAVgcAAKr4//8BAAAAf39/AAEAAABkAAAAAAAAABQAAABAHwAAAAAAACYAAAAAAAAAwOD//wAAAAAmAAAAZAAAABYAAABMAAAAAAAAAAAAAAAEAAAAAAAAAAEAAABZWVkKAAAAACgAAAAoAAAAZAAAAGQAAAAAAAAAzMzMAAAAAABQAAAAUAAAAGQAAABkAAAAAAAAABcAAAAUAAAAAAAAAAAAAAD/fwAA/38AAAAAAAAJAAAABAAAAF8AYAAeAAAAaAAAAAAAAAAAAAAAAAAAAAAAAAAAAAAAECcAABAnAAAAAAAAAAAAAAAAAAAAAAAAAAAAAAAAAAAAAAAAAAAAABQAAAAAAAAAwMD/AAAAAABkAAAAMgAAAAAAAABkAAAAAAAAAH9/fwAKAAAAIgAAABgAAAAAAAAAAAAAAAAAAAAAAAAAAAAAAAAAAAAkAAAAJAAAAAAAAAAHAAAAAAAAAAAAAAAAAAAAAAAAAAAAAAAAAAAAf39/ACUAAABYAAAAAAAAAAAAAAAAAAAAAAAAAAAAAAAAAAAAAAAAAAAAAAAAAAAAAAAAAAAAAAA/AAAAAAAAAKCGAQAAAAAAAAAAAAAAAAAMAAAAAQAAAAAAAAAAAAAAAAAAAB8AAABUAAAAAAAABQAAAAEAAAAAAAAAAAAAAAAAAAAAAAAAAAAAAAAAAAAAAAAAAAAAAAJ/f38AAAAAA8zMzADAwP8Af39/AAAAAAAAAAAAAAAAAAAAAAAAAAAAIQAAABgAAAAUAAAAHjQAAEAmAAB/NwAAeikAABAAAAAmAAAACAAAADywAAAAAAAA"/>
               </a:ext>
             </a:extLst>
           </p:cNvSpPr>
@@ -5906,7 +5906,7 @@
               </a:spcAft>
               <a:buNone/>
             </a:pPr>
-            <a:fld id="{3FDACB68-26D2-8F3D-9C62-D068852C6A85}" type="slidenum">
+            <a:fld id="{3FD94E95-DBD2-8CB8-9C61-2DED002F6A78}" type="slidenum">
               <a:rPr lang="ru-ru" cap="none"/>
               <a:t/>
             </a:fld>
@@ -5921,7 +5921,7 @@
             <a:spLocks noGrp="1" noChangeArrowheads="1"/>
             <a:extLst>
               <a:ext uri="smNativeData">
-                <pr:smNativeData xmlns:pr="smNativeData" xmlns="smNativeData" val="SMDATA_15_LkR5ZhMAAAAlAAAAZAAAAA0AAAAAkAAAAJAAAACQAAAAkAAAAAAAAAAAAAAAAAAAAAEAAABQAAAAAAAAAAAA4D8AAAAAAADgPwAAAAAAAOA/AAAAAAAA4D8AAAAAAADgPwAAAAAAAOA/AAAAAAAA4D8AAAAAAADgPwAAAAAAAOA/AAAAAAAA4D8CAAAAjAAAAAAAAAAAAAAAQoX0DP///wgAAAAAAAAAAAAAAAAAAAAAAAAAAAAAAAAAAAAAZAAAAAEAAABAAAAAAAAAAAAAAAAAAAAAAAAAAAAAAAAAAAAAAAAAAAAAAAAAAAAAAAAAAAAAAAAAAAAAAAAAAAAAAAAAAAAAAAAAAAAAAAAAAAAAAAAAAAAAAAAAAAAAFAAAADwAAAAAAAAAAAAAAAAAAAkUAAAAAQAAABQAAAAUAAAAFAAAAAEAAAAAAAAAZAAAAGQAAAAAAAAAZAAAAGQAAAAVAAAAYAAAAAAAAAAAAAAADwAAACADAAAAAAAAAAAAAAEAAACgMgAAVgcAAKr4//8BAAAAf39/AAEAAABkAAAAAAAAABQAAABAHwAAAAAAACYAAAAAAAAAwOD//wAAAAAmAAAAZAAAABYAAABMAAAAAAAAAAAAAAAEAAAAAAAAAAEAAABZWVkKAAAAACgAAAAoAAAAZAAAAGQAAAAAAAAAzMzMAAAAAABQAAAAUAAAAGQAAABkAAAAAAAAABcAAAAUAAAAAAAAAAAAAAD/fwAA/38AAAAAAAAJAAAABAAAAADvvg8eAAAAaAAAAAAAAAAAAAAAAAAAAAAAAAAAAAAAECcAABAnAAAAAAAAAAAAAAAAAAAAAAAAAAAAAAAAAAAAAAAAAAAAABQAAAAAAAAAwMD/AAAAAABkAAAAMgAAAAAAAABkAAAAAAAAAH9/fwAKAAAAIgAAABgAAAAAAAAAAAAAAAAAAAAAAAAAAAAAAAAAAAAkAAAAJAAAAAAAAAAHAAAAAAAAAAAAAAAAAAAAAAAAAAAAAAAAAAAAf39/ACUAAABYAAAAAAAAAAAAAAAAAAAAAAAAAAAAAAAAAAAAAAAAAAAAAAAAAAAAAAAAAAAAAAA/AAAAAAAAAKCGAQAAAAAAAAAAAAAAAAAMAAAAAQAAAAAAAAAAAAAAAAAAAB8AAABUAAAAAAAABQAAAAEAAAAAAAAAAAAAAAAAAAAAAAAAAAAAAAAAAAAAAAAAAAAAAAJ/f38AAAAAA8zMzADAwP8Af39/AAAAAAAAAAAAAAAAAAAAAAAAAAAAIQAAABgAAAAUAAAAFAMAALYCAAB/NwAAvwoAABAAAAAmAAAACAAAADywAAAAAAAA"/>
+                <pr:smNativeData xmlns:pr="smNativeData" xmlns="smNativeData" val="SMDATA_15_FUV5ZhMAAAAlAAAAZAAAAA0AAAAAkAAAAJAAAACQAAAAkAAAAAAAAAAAAAAAAAAAAAEAAABQAAAAAAAAAAAA4D8AAAAAAADgPwAAAAAAAOA/AAAAAAAA4D8AAAAAAADgPwAAAAAAAOA/AAAAAAAA4D8AAAAAAADgPwAAAAAAAOA/AAAAAAAA4D8CAAAAjAAAAAAAAAAAAAAAQoX0DP///wgAAAAAAAAAAAAAAAAAAAAAAAAAAAAAAAAAAAAAZAAAAAEAAABAAAAAAAAAAAAAAAAAAAAAAAAAAAAAAAAAAAAAAAAAAAAAAAAAAAAAAAAAAAAAAAAAAAAAAAAAAAAAAAAAAAAAAAAAAAAAAAAAAAAAAAAAAAAAAAAAAAAAFAAAADwAAAAAAAAAAAAAAAAAAAkUAAAAAQAAABQAAAAUAAAAFAAAAAEAAAAAAAAAZAAAAGQAAAAAAAAAZAAAAGQAAAAVAAAAYAAAAAAAAAAAAAAADwAAACADAAAAAAAAAAAAAAEAAACgMgAAVgcAAKr4//8BAAAAf39/AAEAAABkAAAAAAAAABQAAABAHwAAAAAAACYAAAAAAAAAwOD//wAAAAAmAAAAZAAAABYAAABMAAAAAAAAAAAAAAAEAAAAAAAAAAEAAABZWVkKAAAAACgAAAAoAAAAZAAAAGQAAAAAAAAAzMzMAAAAAABQAAAAUAAAAGQAAABkAAAAAAAAABcAAAAUAAAAAAAAAAAAAAD/fwAA/38AAAAAAAAJAAAABAAAAADvvg8eAAAAaAAAAAAAAAAAAAAAAAAAAAAAAAAAAAAAECcAABAnAAAAAAAAAAAAAAAAAAAAAAAAAAAAAAAAAAAAAAAAAAAAABQAAAAAAAAAwMD/AAAAAABkAAAAMgAAAAAAAABkAAAAAAAAAH9/fwAKAAAAIgAAABgAAAAAAAAAAAAAAAAAAAAAAAAAAAAAAAAAAAAkAAAAJAAAAAAAAAAHAAAAAAAAAAAAAAAAAAAAAAAAAAAAAAAAAAAAf39/ACUAAABYAAAAAAAAAAAAAAAAAAAAAAAAAAAAAAAAAAAAAAAAAAAAAAAAAAAAAAAAAAAAAAA/AAAAAAAAAKCGAQAAAAAAAAAAAAAAAAAMAAAAAQAAAAAAAAAAAAAAAAAAAB8AAABUAAAAAAAABQAAAAEAAAAAAAAAAAAAAAAAAAAAAAAAAAAAAAAAAAAAAAAAAAAAAAJ/f38AAAAAA8zMzADAwP8Af39/AAAAAAAAAAAAAAAAAAAAAAAAAAAAIQAAABgAAAAUAAAAFAMAALYCAAB/NwAAvwoAABAAAAAmAAAACAAAADywAAAAAAAA"/>
               </a:ext>
             </a:extLst>
           </p:cNvSpPr>
@@ -6031,7 +6031,7 @@
             <a:spLocks noGrp="1" noChangeArrowheads="1"/>
             <a:extLst>
               <a:ext uri="smNativeData">
-                <pr:smNativeData xmlns:pr="smNativeData" xmlns="smNativeData" val="SMDATA_15_LkR5ZhMAAAAlAAAAZAAAAE0AAAAAkAAAAJAAAACQAAAAkAAAAAAAAAAAAAAAAAAAAAEAAABQAAAAAAAAAAAA4D8AAAAAAADgPwAAAAAAAOA/AAAAAAAA4D8AAAAAAADgPwAAAAAAAOA/AAAAAAAA4D8AAAAAAADgPwAAAAAAAOA/AAAAAAAA4D8CAAAAjAAAAAAAAAAAAAAAQoX0DP///wgAAAAAAAAAAAAAAAAAAAAAAAAAAAAAAAAAAAAAZAAAAAEAAABAAAAAAAAAAAAAAAAAAAAAAAAAAAAAAAAAAAAAAAAAAAAAAAAAAAAAAAAAAAAAAAAAAAAAAAAAAAAAAAAAAAAAAAAAAAAAAAAAAAAAAAAAAAAAAAAAAAAAFAAAADwAAAAAAAAAAAAAAAAAAAkUAAAAAQAAABQAAAAUAAAAFAAAAAEAAAAAAAAAZAAAAGQAAAAAAAAAZAAAAGQAAAAVAAAAYAAAAAAAAAAAAAAADwAAACADAAAAAAAAAAAAAAEAAACgMgAAVgcAAKr4//8BAAAAf39/AAEAAABkAAAAAAAAABQAAABAHwAAAAAAACYAAAAAAAAAwOD//wAAAAAmAAAAZAAAABYAAABMAAAAAAAAAAAAAAAEAAAAAAAAAAEAAABZWVkKAAAAACgAAAAoAAAAZAAAAGQAAAAAAAAAzMzMAAAAAABQAAAAUAAAAGQAAABkAAAAAAAAABcAAAAUAAAAAAAAAAAAAAD/fwAA/38AAAAAAAAJAAAABAAAAGdlODkeAAAAaAAAAAAAAAAAAAAAAAAAAAAAAAAAAAAAECcAABAnAAAAAAAAAAAAAAAAAAAAAAAAAAAAAAAAAAAAAAAAAAAAABQAAAAAAAAAwMD/AAAAAABkAAAAMgAAAAAAAABkAAAAAAAAAH9/fwAKAAAAIgAAABgAAAAAAAAAAAAAAAAAAAAAAAAAAAAAAAAAAAAkAAAAJAAAAAAAAAAHAAAAAAAAAAAAAAAAAAAAAAAAAAAAAAAAAAAAf39/ACUAAABYAAAAAAAAAAAAAAAAAAAAAAAAAAAAAAAAAAAAAAAAAAAAAAAAAAAAAAAAAAAAAAA/AAAAAAAAAKCGAQAAAAAAAAAAAAAAAAAMAAAAAQAAAAAAAAAAAAAAAAAAAB8AAABUAAAAAAAABQAAAAEAAAAAAAAAAAAAAAAAAAAAAAAAAAAAAAAAAAAAAAAAAAAAAAJ/f38AAAAAA8zMzADAwP8Af39/AAAAAAAAAAAAAAAAAAAAAAAAAAAAIQAAABgAAAAUAAAAXAgAALAKAAAUJAAAtiYAABAgAAAmAAAACAAAAD2wAAAAAAAA"/>
+                <pr:smNativeData xmlns:pr="smNativeData" xmlns="smNativeData" val="SMDATA_15_FUV5ZhMAAAAlAAAAZAAAAE0AAAAAkAAAAJAAAACQAAAAkAAAAAAAAAAAAAAAAAAAAAEAAABQAAAAAAAAAAAA4D8AAAAAAADgPwAAAAAAAOA/AAAAAAAA4D8AAAAAAADgPwAAAAAAAOA/AAAAAAAA4D8AAAAAAADgPwAAAAAAAOA/AAAAAAAA4D8CAAAAjAAAAAAAAAAAAAAAQoX0DP///wgAAAAAAAAAAAAAAAAAAAAAAAAAAAAAAAAAAAAAZAAAAAEAAABAAAAAAAAAAAAAAAAAAAAAAAAAAAAAAAAAAAAAAAAAAAAAAAAAAAAAAAAAAAAAAAAAAAAAAAAAAAAAAAAAAAAAAAAAAAAAAAAAAAAAAAAAAAAAAAAAAAAAFAAAADwAAAAAAAAAAAAAAAAAAAkUAAAAAQAAABQAAAAUAAAAFAAAAAEAAAAAAAAAZAAAAGQAAAAAAAAAZAAAAGQAAAAVAAAAYAAAAAAAAAAAAAAADwAAACADAAAAAAAAAAAAAAEAAACgMgAAVgcAAKr4//8BAAAAf39/AAEAAABkAAAAAAAAABQAAABAHwAAAAAAACYAAAAAAAAAwOD//wAAAAAmAAAAZAAAABYAAABMAAAAAAAAAAAAAAAEAAAAAAAAAAEAAABZWVkKAAAAACgAAAAoAAAAZAAAAGQAAAAAAAAAzMzMAAAAAABQAAAAUAAAAGQAAABkAAAAAAAAABcAAAAUAAAAAAAAAAAAAAD/fwAA/38AAAAAAAAJAAAABAAAAGdlODkeAAAAaAAAAAAAAAAAAAAAAAAAAAAAAAAAAAAAECcAABAnAAAAAAAAAAAAAAAAAAAAAAAAAAAAAAAAAAAAAAAAAAAAABQAAAAAAAAAwMD/AAAAAABkAAAAMgAAAAAAAABkAAAAAAAAAH9/fwAKAAAAIgAAABgAAAAAAAAAAAAAAAAAAAAAAAAAAAAAAAAAAAAkAAAAJAAAAAAAAAAHAAAAAAAAAAAAAAAAAAAAAAAAAAAAAAAAAAAAf39/ACUAAABYAAAAAAAAAAAAAAAAAAAAAAAAAAAAAAAAAAAAAAAAAAAAAAAAAAAAAAAAAAAAAAA/AAAAAAAAAKCGAQAAAAAAAAAAAAAAAAAMAAAAAQAAAAAAAAAAAAAAAAAAAB8AAABUAAAAAAAABQAAAAEAAAAAAAAAAAAAAAAAAAAAAAAAAAAAAAAAAAAAAAAAAAAAAAJ/f38AAAAAA8zMzADAwP8Af39/AAAAAAAAAAAAAAAAAAAAAAAAAAAAIQAAABgAAAAUAAAAXAgAALAKAAAUJAAAtiYAABAgAAAmAAAACAAAAD2wAAAAAAAA"/>
               </a:ext>
             </a:extLst>
           </p:cNvSpPr>
@@ -6224,7 +6224,7 @@
             <a:spLocks noGrp="1" noChangeArrowheads="1"/>
             <a:extLst>
               <a:ext uri="smNativeData">
-                <pr:smNativeData xmlns:pr="smNativeData" xmlns="smNativeData" val="SMDATA_15_LkR5ZhMAAAAlAAAAZAAAAA0AAAAAkAAAAJAAAACQAAAAkAAAAAAAAAABAAAAAAAAAAEAAABQAAAAAAAAAAAA4D8AAAAAAADgPwAAAAAAAOA/AAAAAAAA4D8AAAAAAADgPwAAAAAAAOA/AAAAAAAA4D8AAAAAAADgPwAAAAAAAOA/AAAAAAAA4D8CAAAAjAAAAAAAAAAAAAAAQoX0DP///wgAAAAAAAAAAAAAAAAAAAAAAAAAAAAAAAAAAAAAZAAAAAEAAABAAAAAAAAAAAAAAAAAAAAAAAAAAAAAAAAAAAAAAAAAAAAAAAAAAAAAAAAAAAAAAAAAAAAAAAAAAAAAAAAAAAAAAAAAAAAAAAAAAAAAAAAAAAAAAAAAAAAAFAAAADwAAAAAAAAAAAAAAAAAAAkUAAAAAQAAABQAAAAUAAAAFAAAAAEAAAAAAAAAZAAAAGQAAAAAAAAAZAAAAGQAAAAVAAAAYAAAAAAAAAAAAAAADwAAACADAAAAAAAAAAAAAAEAAACgMgAAVgcAAKr4//8BAAAAf39/AAEAAABkAAAAAAAAABQAAABAHwAAAAAAACYAAAAAAAAAwOD//wAAAAAmAAAAZAAAABYAAABMAAAAAAAAAAAAAAAEAAAAAAAAAAEAAABZWVkKAAAAACgAAAAoAAAAZAAAAGQAAAAAAAAAzMzMAAAAAABQAAAAUAAAAGQAAABkAAAAAAAAABcAAAAUAAAAAAAAAAAAAAD/fwAA/38AAAAAAAAJAAAABAAAAAAAAAAeAAAAaAAAAAAAAAAAAAAAAAAAAAAAAAAAAAAAECcAABAnAAAAAAAAAAAAAAAAAAAAAAAAAAAAAAAAAAAAAAAAAAAAABQAAAAAAAAAwMD/AAAAAABkAAAAMgAAAAAAAABkAAAAAAAAAH9/fwAKAAAAIgAAABgAAAAAAAAAAAAAAAAAAAAAAAAAAAAAAAAAAAAkAAAAJAAAAAAAAAAHAAAAAAAAAAAAAAAAAAAAAAAAAAAAAAAAAAAAf39/ACUAAABYAAAAAAAAAAAAAAAAAAAAAAAAAAAAAAAAAAAAAAAAAAAAAAAAAAAAAAAAAAAAAAA/AAAAAAAAAKCGAQAAAAAAAAAAAAAAAAAMAAAAAQAAAAAAAAAAAAAAAAAAAB8AAABUAAAAAAAABQAAAAEAAAAAAAAAAAAAAAAAAAAAAAAAAAAAAAAAAAAAAAAAAAAAAAJ/f38AAAAAA8zMzADAwP8Af39/AAAAAAAAAAAAAAAAAAAAAAAAAAAAIQAAABgAAAAUAAAAHjQAAEAmAAB/NwAAeikAABAAAAAmAAAACAAAADywAAAAAAAA"/>
+                <pr:smNativeData xmlns:pr="smNativeData" xmlns="smNativeData" val="SMDATA_15_FUV5ZhMAAAAlAAAAZAAAAA0AAAAAkAAAAJAAAACQAAAAkAAAAAAAAAABAAAAAAAAAAEAAABQAAAAAAAAAAAA4D8AAAAAAADgPwAAAAAAAOA/AAAAAAAA4D8AAAAAAADgPwAAAAAAAOA/AAAAAAAA4D8AAAAAAADgPwAAAAAAAOA/AAAAAAAA4D8CAAAAjAAAAAAAAAAAAAAAQoX0DP///wgAAAAAAAAAAAAAAAAAAAAAAAAAAAAAAAAAAAAAZAAAAAEAAABAAAAAAAAAAAAAAAAAAAAAAAAAAAAAAAAAAAAAAAAAAAAAAAAAAAAAAAAAAAAAAAAAAAAAAAAAAAAAAAAAAAAAAAAAAAAAAAAAAAAAAAAAAAAAAAAAAAAAFAAAADwAAAAAAAAAAAAAAAAAAAkUAAAAAQAAABQAAAAUAAAAFAAAAAEAAAAAAAAAZAAAAGQAAAAAAAAAZAAAAGQAAAAVAAAAYAAAAAAAAAAAAAAADwAAACADAAAAAAAAAAAAAAEAAACgMgAAVgcAAKr4//8BAAAAf39/AAEAAABkAAAAAAAAABQAAABAHwAAAAAAACYAAAAAAAAAwOD//wAAAAAmAAAAZAAAABYAAABMAAAAAAAAAAAAAAAEAAAAAAAAAAEAAABZWVkKAAAAACgAAAAoAAAAZAAAAGQAAAAAAAAAzMzMAAAAAABQAAAAUAAAAGQAAABkAAAAAAAAABcAAAAUAAAAAAAAAAAAAAD/fwAA/38AAAAAAAAJAAAABAAAAAAAAAAeAAAAaAAAAAAAAAAAAAAAAAAAAAAAAAAAAAAAECcAABAnAAAAAAAAAAAAAAAAAAAAAAAAAAAAAAAAAAAAAAAAAAAAABQAAAAAAAAAwMD/AAAAAABkAAAAMgAAAAAAAABkAAAAAAAAAH9/fwAKAAAAIgAAABgAAAAAAAAAAAAAAAAAAAAAAAAAAAAAAAAAAAAkAAAAJAAAAAAAAAAHAAAAAAAAAAAAAAAAAAAAAAAAAAAAAAAAAAAAf39/ACUAAABYAAAAAAAAAAAAAAAAAAAAAAAAAAAAAAAAAAAAAAAAAAAAAAAAAAAAAAAAAAAAAAA/AAAAAAAAAKCGAQAAAAAAAAAAAAAAAAAMAAAAAQAAAAAAAAAAAAAAAAAAAB8AAABUAAAAAAAABQAAAAEAAAAAAAAAAAAAAAAAAAAAAAAAAAAAAAAAAAAAAAAAAAAAAAJ/f38AAAAAA8zMzADAwP8Af39/AAAAAAAAAAAAAAAAAAAAAAAAAAAAIQAAABgAAAAUAAAAHjQAAEAmAAB/NwAAeikAABAAAAAmAAAACAAAADywAAAAAAAA"/>
               </a:ext>
             </a:extLst>
           </p:cNvSpPr>
@@ -6278,7 +6278,7 @@
               </a:spcAft>
               <a:buNone/>
             </a:pPr>
-            <a:fld id="{3FDAD9DC-92D2-8F2F-9C62-647A972C6A31}" type="slidenum">
+            <a:fld id="{3FD95970-3ED2-8CAF-9C61-C8FA172F6A9D}" type="slidenum">
               <a:rPr lang="ru-ru" cap="none"/>
               <a:t/>
             </a:fld>
@@ -6292,7 +6292,7 @@
           <p:cNvPicPr>
             <a:extLst>
               <a:ext uri="smNativeData">
-                <pr:smNativeData xmlns:pr="smNativeData" xmlns="smNativeData" val="SMDATA_17_LkR5ZhMAAAAlAAAAEQAAAA0AAAAAkAAAAEgAAACQAAAASAAAAAAAAAAAAAAAAAAAAAEAAABQAAAAAAAAAAAA4D8AAAAAAADgPwAAAAAAAOA/AAAAAAAA4D8AAAAAAADgPwAAAAAAAOA/AAAAAAAA4D8AAAAAAADgPwAAAAAAAOA/AAAAAAAA4D8CAAAAjAAAAAAAAAAAAAAAQoX0DP///wgAAAAAAAAAAAAAAAAAAAAAAAAAAAAAAAAAAAAAZAAAAAEAAABAAAAAAAAAAAAAAAAAAAAAAAAAAAAAAAAAAAAAAAAAAAAAAAAAAAAAAAAAAAAAAAAAAAAAAAAAAAAAAAAAAAAAAAAAAAAAAAAAAAAAAAAAAAAAAAAAAAAAFAAAADwAAAAAAAAAAAAAAAAAAAkUAAAAAQAAABQAAAAUAAAAFAAAAAEAAAAAAAAAZAAAAGQAAAAAAAAAZAAAAGQAAAAVAAAAYAAAAAAAAAAAAAAADwAAACADAAAAAAAAAAAAAAEAAACgMgAAVgcAAKr4//8BAAAAf39/AAEAAABkAAAAAAAAABQAAABAHwAAAAAAACYAAAAAAAAAwOD//wAAAAAmAAAAZAAAABYAAABMAAAAAAAAAAAAAAAEAAAAAAAAAAEAAABZWVkKAAAAACgAAAAoAAAAZAAAAGQAAAAAAAAAzMzMAAAAAABQAAAAUAAAAGQAAABkAAAAAAAAAAcAAAA4AAAAAAAAAAAAAAAAAAAA////AAAAAAAAAAAAAAAAAAAAAAAAAAAAAAAAAAAAAABkAAAAZAAAAAAAAAAjAAAABAAAAGQAAAAXAAAAFAAAAAAAAAAAAAAA/38AAP9/AAAAAAAACQAAAAQAAACwmIhjHgAAAGgAAAAAAAAAAAAAAAAAAAAAAAAAAAAAABAnAAAQJwAAAAAAAAAAAAAAAAAAAAAAAAAAAAAAAAAAAAAAAAAAAAAUAAAAAAAAAMDA/wAAAAAAZAAAADIAAAAAAAAAZAAAAAAAAAB/f38ACgAAACIAAAAYAAAAAAAAAAAAAAAAAAAAAAAAAAAAAAAAAAAAJAAAACQAAAAAAAAABwAAAAAAAAAAAAAAAAAAAAAAAAAAAAAAAAAAAH9/fwAlAAAAWAAAAAAAAAAAAAAAAAAAAAAAAAAAAAAAAAAAAAAAAAAAAAAAAAAAAAAAAAAAAAAAPwAAAAAAAACghgEAAAAAAAAAAAAAAAAADAAAAAEAAAAAAAAAAAAAAAAAAAAfAAAAVAAAAEKF9AX///8BAAAAAAAAAAAAAAAAAAAAAAAAAAAAAAAAAAAAAAAAAAAAAAACf39/AFlZWQPMzMwAwMD/AH9/fwAAAAAAAAAAAAAAAAD///8AAAAAACEAAAAYAAAAFAAAAAAAAAAAAAAAQDgAADAqAAAQAAAAJgAAAAgAAAD//////////w=="/>
+                <pr:smNativeData xmlns:pr="smNativeData" xmlns="smNativeData" val="SMDATA_17_FUV5ZhMAAAAlAAAAEQAAAA0AAAAAkAAAAEgAAACQAAAASAAAAAAAAAAAAAAAAAAAAAEAAABQAAAAAAAAAAAA4D8AAAAAAADgPwAAAAAAAOA/AAAAAAAA4D8AAAAAAADgPwAAAAAAAOA/AAAAAAAA4D8AAAAAAADgPwAAAAAAAOA/AAAAAAAA4D8CAAAAjAAAAAAAAAAAAAAAQoX0DP///wgAAAAAAAAAAAAAAAAAAAAAAAAAAAAAAAAAAAAAZAAAAAEAAABAAAAAAAAAAAAAAAAAAAAAAAAAAAAAAAAAAAAAAAAAAAAAAAAAAAAAAAAAAAAAAAAAAAAAAAAAAAAAAAAAAAAAAAAAAAAAAAAAAAAAAAAAAAAAAAAAAAAAFAAAADwAAAAAAAAAAAAAAAAAAAkUAAAAAQAAABQAAAAUAAAAFAAAAAEAAAAAAAAAZAAAAGQAAAAAAAAAZAAAAGQAAAAVAAAAYAAAAAAAAAAAAAAADwAAACADAAAAAAAAAAAAAAEAAACgMgAAVgcAAKr4//8BAAAAf39/AAEAAABkAAAAAAAAABQAAABAHwAAAAAAACYAAAAAAAAAwOD//wAAAAAmAAAAZAAAABYAAABMAAAAAAAAAAAAAAAEAAAAAAAAAAEAAABZWVkKAAAAACgAAAAoAAAAZAAAAGQAAAAAAAAAzMzMAAAAAABQAAAAUAAAAGQAAABkAAAAAAAAAAcAAAA4AAAAAAAAAAAAAAAAAAAA////AAAAAAAAAAAAAAAAAAAAAAAAAAAAAAAAAAAAAABkAAAAZAAAAAAAAAAjAAAABAAAAGQAAAAXAAAAFAAAAAAAAAAAAAAA/38AAP9/AAAAAAAACQAAAAQAAACwmIhjHgAAAGgAAAAAAAAAAAAAAAAAAAAAAAAAAAAAABAnAAAQJwAAAAAAAAAAAAAAAAAAAAAAAAAAAAAAAAAAAAAAAAAAAAAUAAAAAAAAAMDA/wAAAAAAZAAAADIAAAAAAAAAZAAAAAAAAAB/f38ACgAAACIAAAAYAAAAAAAAAAAAAAAAAAAAAAAAAAAAAAAAAAAAJAAAACQAAAAAAAAABwAAAAAAAAAAAAAAAAAAAAAAAAAAAAAAAAAAAH9/fwAlAAAAWAAAAAAAAAAAAAAAAAAAAAAAAAAAAAAAAAAAAAAAAAAAAAAAAAAAAAAAAAAAAAAAPwAAAAAAAACghgEAAAAAAAAAAAAAAAAADAAAAAEAAAAAAAAAAAAAAAAAAAAfAAAAVAAAAEKF9AX///8BAAAAAAAAAAAAAAAAAAAAAAAAAAAAAAAAAAAAAAAAAAAAAAACf39/AFlZWQPMzMwAwMD/AH9/fwAAAAAAAAAAAAAAAAD///8AAAAAACEAAAAYAAAAFAAAAAAAAAAAAAAAQDgAADAqAAAQAAAAJgAAAAgAAAD//////////w=="/>
               </a:ext>
             </a:extLst>
           </p:cNvPicPr>
@@ -6326,7 +6326,7 @@
             <a:spLocks noGrp="1" noChangeArrowheads="1"/>
             <a:extLst>
               <a:ext uri="smNativeData">
-                <pr:smNativeData xmlns:pr="smNativeData" xmlns="smNativeData" val="SMDATA_15_LkR5ZhMAAAAlAAAAZAAAAA0AAAAAkAAAAJAAAACQAAAAkAAAAAAAAAABAAAAAAAAAAEAAABQAAAAAAAAAAAA4D8AAAAAAADgPwAAAAAAAOA/AAAAAAAA4D8AAAAAAADgPwAAAAAAAOA/AAAAAAAA4D8AAAAAAADgPwAAAAAAAOA/AAAAAAAA4D8CAAAAjAAAAAAAAAAAAAAAQoX0DP///wgAAAAAAAAAAAAAAAAAAAAAAAAAAAAAAAAAAAAAZAAAAAEAAABAAAAAAAAAAAAAAAAAAAAAAAAAAAAAAAAAAAAAAAAAAAAAAAAAAAAAAAAAAAAAAAAAAAAAAAAAAAAAAAAAAAAAAAAAAAAAAAAAAAAAAAAAAAAAAAAAAAAAFAAAADwAAAAAAAAAAAAAAAAAAAkUAAAAAQAAABQAAAAUAAAAFAAAAAEAAAAAAAAAZAAAAGQAAAAAAAAAZAAAAGQAAAAVAAAAYAAAAAAAAAAAAAAADwAAACADAAAAAAAAAAAAAAEAAACgMgAAVgcAAKr4//8BAAAAf39/AAEAAABkAAAAAAAAABQAAABAHwAAAAAAACYAAAAAAAAAwOD//wAAAAAmAAAAZAAAABYAAABMAAAAAAAAAAAAAAAEAAAAAAAAAAEAAABZWVkKAAAAACgAAAAoAAAAZAAAAGQAAAAAAAAAzMzMAAAAAABQAAAAUAAAAGQAAABkAAAAAAAAABcAAAAUAAAAAAAAAAAAAAD/fwAA/38AAAAAAAAJAAAABAAAAG0AOwAeAAAAaAAAAAAAAAAAAAAAAAAAAAAAAAAAAAAAECcAABAnAAAAAAAAAAAAAAAAAAAAAAAAAAAAAAAAAAAAAAAAAAAAABQAAAAAAAAAwMD/AAAAAABkAAAAMgAAAAAAAABkAAAAAAAAAH9/fwAKAAAAIgAAABgAAAAAAAAAAAAAAAAAAAAAAAAAAAAAAAAAAAAkAAAAJAAAAAAAAAAHAAAAAAAAAAAAAAAAAAAAAAAAAAAAAAAAAAAAf39/ACUAAABYAAAAAAAAAAAAAAAAAAAAAAAAAAAAAAAAAAAAAAAAAAAAAAAAAAAAAAAAAAAAAAA/AAAAAAAAAKCGAQAAAAAAAAAAAAAAAAAMAAAAAQAAAAAAAAAAAAAAAAAAAB8AAABUAAAAAAAABQAAAAEAAAAAAAAAAAAAAAAAAAAAAAAAAAAAAAAAAAAAAAAAAAAAAAJ/f38AAAAAA8zMzADAwP8Af39/AAAAAAAAAAAAAAAAAAAAAAAAAAAAIQAAABgAAAAUAAAA4gUAAEADAAA5NQAAziQAABAAAAAmAAAACAAAAL2wAAAAAAAA"/>
+                <pr:smNativeData xmlns:pr="smNativeData" xmlns="smNativeData" val="SMDATA_15_FUV5ZhMAAAAlAAAAZAAAAA0AAAAAkAAAAJAAAACQAAAAkAAAAAAAAAABAAAAAAAAAAEAAABQAAAAAAAAAAAA4D8AAAAAAADgPwAAAAAAAOA/AAAAAAAA4D8AAAAAAADgPwAAAAAAAOA/AAAAAAAA4D8AAAAAAADgPwAAAAAAAOA/AAAAAAAA4D8CAAAAjAAAAAAAAAAAAAAAQoX0DP///wgAAAAAAAAAAAAAAAAAAAAAAAAAAAAAAAAAAAAAZAAAAAEAAABAAAAAAAAAAAAAAAAAAAAAAAAAAAAAAAAAAAAAAAAAAAAAAAAAAAAAAAAAAAAAAAAAAAAAAAAAAAAAAAAAAAAAAAAAAAAAAAAAAAAAAAAAAAAAAAAAAAAAFAAAADwAAAAAAAAAAAAAAAAAAAkUAAAAAQAAABQAAAAUAAAAFAAAAAEAAAAAAAAAZAAAAGQAAAAAAAAAZAAAAGQAAAAVAAAAYAAAAAAAAAAAAAAADwAAACADAAAAAAAAAAAAAAEAAACgMgAAVgcAAKr4//8BAAAAf39/AAEAAABkAAAAAAAAABQAAABAHwAAAAAAACYAAAAAAAAAwOD//wAAAAAmAAAAZAAAABYAAABMAAAAAAAAAAAAAAAEAAAAAAAAAAEAAABZWVkKAAAAACgAAAAoAAAAZAAAAGQAAAAAAAAAzMzMAAAAAABQAAAAUAAAAGQAAABkAAAAAAAAABcAAAAUAAAAAAAAAAAAAAD/fwAA/38AAAAAAAAJAAAABAAAAG0AOwAeAAAAaAAAAAAAAAAAAAAAAAAAAAAAAAAAAAAAECcAABAnAAAAAAAAAAAAAAAAAAAAAAAAAAAAAAAAAAAAAAAAAAAAABQAAAAAAAAAwMD/AAAAAABkAAAAMgAAAAAAAABkAAAAAAAAAH9/fwAKAAAAIgAAABgAAAAAAAAAAAAAAAAAAAAAAAAAAAAAAAAAAAAkAAAAJAAAAAAAAAAHAAAAAAAAAAAAAAAAAAAAAAAAAAAAAAAAAAAAf39/ACUAAABYAAAAAAAAAAAAAAAAAAAAAAAAAAAAAAAAAAAAAAAAAAAAAAAAAAAAAAAAAAAAAAA/AAAAAAAAAKCGAQAAAAAAAAAAAAAAAAAMAAAAAQAAAAAAAAAAAAAAAAAAAB8AAABUAAAAAAAABQAAAAEAAAAAAAAAAAAAAAAAAAAAAAAAAAAAAAAAAAAAAAAAAAAAAAJ/f38AAAAAA8zMzADAwP8Af39/AAAAAAAAAAAAAAAAAAAAAAAAAAAAIQAAABgAAAAUAAAA4gUAAEADAAA5NQAAziQAABAAAAAmAAAACAAAAL2wAAAAAAAA"/>
               </a:ext>
             </a:extLst>
           </p:cNvSpPr>
@@ -6480,7 +6480,7 @@
             <a:spLocks noGrp="1" noChangeArrowheads="1"/>
             <a:extLst>
               <a:ext uri="smNativeData">
-                <pr:smNativeData xmlns:pr="smNativeData" xmlns="smNativeData" val="SMDATA_15_LkR5ZhMAAAAlAAAAZAAAAA0AAAAAkAAAAJAAAACQAAAAkAAAAAAAAAAAAAAAAAAAAAEAAABQAAAAAAAAAAAA4D8AAAAAAADgPwAAAAAAAOA/AAAAAAAA4D8AAAAAAADgPwAAAAAAAOA/AAAAAAAA4D8AAAAAAADgPwAAAAAAAOA/AAAAAAAA4D8CAAAAjAAAAAAAAAAAAAAAQoX0DP///wgAAAAAAAAAAAAAAAAAAAAAAAAAAAAAAAAAAAAAZAAAAAEAAABAAAAAAAAAAAAAAAAAAAAAAAAAAAAAAAAAAAAAAAAAAAAAAAAAAAAAAAAAAAAAAAAAAAAAAAAAAAAAAAAAAAAAAAAAAAAAAAAAAAAAAAAAAAAAAAAAAAAAFAAAADwAAAAAAAAAAAAAAAAAAAkUAAAAAQAAABQAAAAUAAAAFAAAAAEAAAAAAAAAZAAAAGQAAAAAAAAAZAAAAGQAAAAVAAAAYAAAAAAAAAAAAAAADwAAACADAAAAAAAAAAAAAAEAAACgMgAAVgcAAKr4//8BAAAAf39/AAEAAABkAAAAAAAAABQAAABAHwAAAAAAACYAAAAAAAAAwOD//wAAAAAmAAAAZAAAABYAAABMAAAAAAAAAAAAAAAEAAAAAAAAAAEAAABZWVkKAAAAACgAAAAoAAAAZAAAAGQAAAAAAAAAzMzMAAAAAABQAAAAUAAAAGQAAABkAAAAAAAAABcAAAAUAAAAAAAAAAAAAAD/fwAA/38AAAAAAAAJAAAABAAAAF0AXgAeAAAAaAAAAAAAAAAAAAAAAAAAAAAAAAAAAAAAECcAABAnAAAAAAAAAAAAAAAAAAAAAAAAAAAAAAAAAAAAAAAAAAAAABQAAAAAAAAAwMD/AAAAAABkAAAAMgAAAAAAAABkAAAAAAAAAH9/fwAKAAAAIgAAABgAAAAAAAAAAAAAAAAAAAAAAAAAAAAAAAAAAAAkAAAAJAAAAAAAAAAHAAAAAAAAAAAAAAAAAAAAAAAAAAAAAAAAAAAAf39/ACUAAABYAAAAAAAAAAAAAAAAAAAAAAAAAAAAAAAAAAAAAAAAAAAAAAAAAAAAAAAAAAAAAAA/AAAAAAAAAKCGAQAAAAAAAAAAAAAAAAAMAAAAAQAAAAAAAAAAAAAAAAAAAB8AAABUAAAAAAAABQAAAAEAAAAAAAAAAAAAAAAAAAAAAAAAAAAAAAAAAAAAAAAAAAAAAAJ/f38AAAAAA8zMzADAwP8Af39/AAAAAAAAAAAAAAAAAAAAAAAAAAAAIQAAABgAAAAUAAAAFAMAALYCAAB/NwAAvwoAABAAAAAmAAAACAAAADywAAAAAAAA"/>
+                <pr:smNativeData xmlns:pr="smNativeData" xmlns="smNativeData" val="SMDATA_15_FUV5ZhMAAAAlAAAAZAAAAA0AAAAAkAAAAJAAAACQAAAAkAAAAAAAAAAAAAAAAAAAAAEAAABQAAAAAAAAAAAA4D8AAAAAAADgPwAAAAAAAOA/AAAAAAAA4D8AAAAAAADgPwAAAAAAAOA/AAAAAAAA4D8AAAAAAADgPwAAAAAAAOA/AAAAAAAA4D8CAAAAjAAAAAAAAAAAAAAAQoX0DP///wgAAAAAAAAAAAAAAAAAAAAAAAAAAAAAAAAAAAAAZAAAAAEAAABAAAAAAAAAAAAAAAAAAAAAAAAAAAAAAAAAAAAAAAAAAAAAAAAAAAAAAAAAAAAAAAAAAAAAAAAAAAAAAAAAAAAAAAAAAAAAAAAAAAAAAAAAAAAAAAAAAAAAFAAAADwAAAAAAAAAAAAAAAAAAAkUAAAAAQAAABQAAAAUAAAAFAAAAAEAAAAAAAAAZAAAAGQAAAAAAAAAZAAAAGQAAAAVAAAAYAAAAAAAAAAAAAAADwAAACADAAAAAAAAAAAAAAEAAACgMgAAVgcAAKr4//8BAAAAf39/AAEAAABkAAAAAAAAABQAAABAHwAAAAAAACYAAAAAAAAAwOD//wAAAAAmAAAAZAAAABYAAABMAAAAAAAAAAAAAAAEAAAAAAAAAAEAAABZWVkKAAAAACgAAAAoAAAAZAAAAGQAAAAAAAAAzMzMAAAAAABQAAAAUAAAAGQAAABkAAAAAAAAABcAAAAUAAAAAAAAAAAAAAD/fwAA/38AAAAAAAAJAAAABAAAAF0AXgAeAAAAaAAAAAAAAAAAAAAAAAAAAAAAAAAAAAAAECcAABAnAAAAAAAAAAAAAAAAAAAAAAAAAAAAAAAAAAAAAAAAAAAAABQAAAAAAAAAwMD/AAAAAABkAAAAMgAAAAAAAABkAAAAAAAAAH9/fwAKAAAAIgAAABgAAAAAAAAAAAAAAAAAAAAAAAAAAAAAAAAAAAAkAAAAJAAAAAAAAAAHAAAAAAAAAAAAAAAAAAAAAAAAAAAAAAAAAAAAf39/ACUAAABYAAAAAAAAAAAAAAAAAAAAAAAAAAAAAAAAAAAAAAAAAAAAAAAAAAAAAAAAAAAAAAA/AAAAAAAAAKCGAQAAAAAAAAAAAAAAAAAMAAAAAQAAAAAAAAAAAAAAAAAAAB8AAABUAAAAAAAABQAAAAEAAAAAAAAAAAAAAAAAAAAAAAAAAAAAAAAAAAAAAAAAAAAAAAJ/f38AAAAAA8zMzADAwP8Af39/AAAAAAAAAAAAAAAAAAAAAAAAAAAAIQAAABgAAAAUAAAAFAMAALYCAAB/NwAAvwoAABAAAAAmAAAACAAAADywAAAAAAAA"/>
               </a:ext>
             </a:extLst>
           </p:cNvSpPr>
@@ -6590,7 +6590,7 @@
             <a:spLocks noGrp="1" noChangeArrowheads="1"/>
             <a:extLst>
               <a:ext uri="smNativeData">
-                <pr:smNativeData xmlns:pr="smNativeData" xmlns="smNativeData" val="SMDATA_15_LkR5ZhMAAAAlAAAAZAAAAA0AAAAAkAAAAJAAAACQAAAAkAAAAAAAAAAAAAAAAAAAAAEAAABQAAAAAAAAAAAA4D8AAAAAAADgPwAAAAAAAOA/AAAAAAAA4D8AAAAAAADgPwAAAAAAAOA/AAAAAAAA4D8AAAAAAADgPwAAAAAAAOA/AAAAAAAA4D8CAAAAjAAAAAAAAAAAAAAAQoX0DP///wgAAAAAAAAAAAAAAAAAAAAAAAAAAAAAAAAAAAAAZAAAAAEAAABAAAAAAAAAAAAAAAAAAAAAAAAAAAAAAAAAAAAAAAAAAAAAAAAAAAAAAAAAAAAAAAAAAAAAAAAAAAAAAAAAAAAAAAAAAAAAAAAAAAAAAAAAAAAAAAAAAAAAFAAAADwAAAAAAAAAAAAAAAAAAAkUAAAAAQAAABQAAAAUAAAAFAAAAAEAAAAAAAAAZAAAAGQAAAAAAAAAZAAAAGQAAAAVAAAAYAAAAAAAAAAAAAAADwAAACADAAAAAAAAAAAAAAEAAACgMgAAVgcAAKr4//8BAAAAf39/AAEAAABkAAAAAAAAABQAAABAHwAAAAAAACYAAAAAAAAAwOD//wAAAAAmAAAAZAAAABYAAABMAAAAAAAAAAAAAAAEAAAAAAAAAAEAAABZWVkKAAAAACgAAAAoAAAAZAAAAGQAAAAAAAAAzMzMAAAAAABQAAAAUAAAAGQAAABkAAAAAAAAABcAAAAUAAAAAAAAAAAAAAD/fwAA/38AAAAAAAAJAAAABAAAAAAAAAAeAAAAaAAAAAAAAAAAAAAAAAAAAAAAAAAAAAAAECcAABAnAAAAAAAAAAAAAAAAAAAAAAAAAAAAAAAAAAAAAAAAAAAAABQAAAAAAAAAwMD/AAAAAABkAAAAMgAAAAAAAABkAAAAAAAAAH9/fwAKAAAAIgAAABgAAAAAAAAAAAAAAAAAAAAAAAAAAAAAAAAAAAAkAAAAJAAAAAAAAAAHAAAAAAAAAAAAAAAAAAAAAAAAAAAAAAAAAAAAf39/ACUAAABYAAAAAAAAAAAAAAAAAAAAAAAAAAAAAAAAAAAAAAAAAAAAAAAAAAAAAAAAAAAAAAA/AAAAAAAAAKCGAQAAAAAAAAAAAAAAAAAMAAAAAQAAAAAAAAAAAAAAAAAAAB8AAABUAAAAAAAABQAAAAEAAAAAAAAAAAAAAAAAAAAAAAAAAAAAAAAAAAAAAAAAAAAAAAJ/f38AAAAAA8zMzADAwP8Af39/AAAAAAAAAAAAAAAAAAAAAAAAAAAAIQAAABgAAAAUAAAAwRoAAJQQAADFNQAAZRUAABAAAAAmAAAACAAAAD2wAAAAAAAA"/>
+                <pr:smNativeData xmlns:pr="smNativeData" xmlns="smNativeData" val="SMDATA_15_FUV5ZhMAAAAlAAAAZAAAAA0AAAAAkAAAAJAAAACQAAAAkAAAAAAAAAAAAAAAAAAAAAEAAABQAAAAAAAAAAAA4D8AAAAAAADgPwAAAAAAAOA/AAAAAAAA4D8AAAAAAADgPwAAAAAAAOA/AAAAAAAA4D8AAAAAAADgPwAAAAAAAOA/AAAAAAAA4D8CAAAAjAAAAAAAAAAAAAAAQoX0DP///wgAAAAAAAAAAAAAAAAAAAAAAAAAAAAAAAAAAAAAZAAAAAEAAABAAAAAAAAAAAAAAAAAAAAAAAAAAAAAAAAAAAAAAAAAAAAAAAAAAAAAAAAAAAAAAAAAAAAAAAAAAAAAAAAAAAAAAAAAAAAAAAAAAAAAAAAAAAAAAAAAAAAAFAAAADwAAAAAAAAAAAAAAAAAAAkUAAAAAQAAABQAAAAUAAAAFAAAAAEAAAAAAAAAZAAAAGQAAAAAAAAAZAAAAGQAAAAVAAAAYAAAAAAAAAAAAAAADwAAACADAAAAAAAAAAAAAAEAAACgMgAAVgcAAKr4//8BAAAAf39/AAEAAABkAAAAAAAAABQAAABAHwAAAAAAACYAAAAAAAAAwOD//wAAAAAmAAAAZAAAABYAAABMAAAAAAAAAAAAAAAEAAAAAAAAAAEAAABZWVkKAAAAACgAAAAoAAAAZAAAAGQAAAAAAAAAzMzMAAAAAABQAAAAUAAAAGQAAABkAAAAAAAAABcAAAAUAAAAAAAAAAAAAAD/fwAA/38AAAAAAAAJAAAABAAAAAAAAAAeAAAAaAAAAAAAAAAAAAAAAAAAAAAAAAAAAAAAECcAABAnAAAAAAAAAAAAAAAAAAAAAAAAAAAAAAAAAAAAAAAAAAAAABQAAAAAAAAAwMD/AAAAAABkAAAAMgAAAAAAAABkAAAAAAAAAH9/fwAKAAAAIgAAABgAAAAAAAAAAAAAAAAAAAAAAAAAAAAAAAAAAAAkAAAAJAAAAAAAAAAHAAAAAAAAAAAAAAAAAAAAAAAAAAAAAAAAAAAAf39/ACUAAABYAAAAAAAAAAAAAAAAAAAAAAAAAAAAAAAAAAAAAAAAAAAAAAAAAAAAAAAAAAAAAAA/AAAAAAAAAKCGAQAAAAAAAAAAAAAAAAAMAAAAAQAAAAAAAAAAAAAAAAAAAB8AAABUAAAAAAAABQAAAAEAAAAAAAAAAAAAAAAAAAAAAAAAAAAAAAAAAAAAAAAAAAAAAAJ/f38AAAAAA8zMzADAwP8Af39/AAAAAAAAAAAAAAAAAAAAAAAAAAAAIQAAABgAAAAUAAAAwRoAAJQQAADFNQAAZRUAABAAAAAmAAAACAAAAD2wAAAAAAAA"/>
               </a:ext>
             </a:extLst>
           </p:cNvSpPr>
@@ -6777,7 +6777,7 @@
             <a:spLocks noGrp="1" noChangeArrowheads="1"/>
             <a:extLst>
               <a:ext uri="smNativeData">
-                <pr:smNativeData xmlns:pr="smNativeData" xmlns="smNativeData" val="SMDATA_15_LkR5ZhMAAAAlAAAAZAAAAA0AAAAAkAAAAJAAAACQAAAAkAAAAAAAAAAAAAAAAAAAAAEAAABQAAAAAAAAAAAA4D8AAAAAAADgPwAAAAAAAOA/AAAAAAAA4D8AAAAAAADgPwAAAAAAAOA/AAAAAAAA4D8AAAAAAADgPwAAAAAAAOA/AAAAAAAA4D8CAAAAjAAAAAAAAAAAAAAAQoX0DP///wgAAAAAAAAAAAAAAAAAAAAAAAAAAAAAAAAAAAAAZAAAAAEAAABAAAAAAAAAAAAAAAAAAAAAAAAAAAAAAAAAAAAAAAAAAAAAAAAAAAAAAAAAAAAAAAAAAAAAAAAAAAAAAAAAAAAAAAAAAAAAAAAAAAAAAAAAAAAAAAAAAAAAFAAAADwAAAAAAAAAAAAAAAAAAAkUAAAAAQAAABQAAAAUAAAAFAAAAAEAAAAAAAAAZAAAAGQAAAAAAAAAZAAAAGQAAAAVAAAAYAAAAAAAAAAAAAAADwAAACADAAAAAAAAAAAAAAEAAACgMgAAVgcAAKr4//8BAAAAf39/AAEAAABkAAAAAAAAABQAAABAHwAAAAAAACYAAAAAAAAAwOD//wAAAAAmAAAAZAAAABYAAABMAAAAAAAAAAAAAAAEAAAAAAAAAAEAAABZWVkKAAAAACgAAAAoAAAAZAAAAGQAAAAAAAAAzMzMAAAAAABQAAAAUAAAAGQAAABkAAAAAAAAABcAAAAUAAAAAAAAAAAAAAD/fwAA/38AAAAAAAAJAAAABAAAAAAAAAAeAAAAaAAAAAAAAAAAAAAAAAAAAAAAAAAAAAAAECcAABAnAAAAAAAAAAAAAAAAAAAAAAAAAAAAAAAAAAAAAAAAAAAAABQAAAAAAAAAwMD/AAAAAABkAAAAMgAAAAAAAABkAAAAAAAAAH9/fwAKAAAAIgAAABgAAAAAAAAAAAAAAAAAAAAAAAAAAAAAAAAAAAAkAAAAJAAAAAAAAAAHAAAAAAAAAAAAAAAAAAAAAAAAAAAAAAAAAAAAf39/ACUAAABYAAAAAAAAAAAAAAAAAAAAAAAAAAAAAAAAAAAAAAAAAAAAAAAAAAAAAAAAAAAAAAA/AAAAAAAAAKCGAQAAAAAAAAAAAAAAAAAMAAAAAQAAAAAAAAAAAAAAAAAAAB8AAABUAAAAAAAABQAAAAEAAAAAAAAAAAAAAAAAAAAAAAAAAAAAAAAAAAAAAAAAAAAAAAJ/f38AAAAAA8zMzADAwP8Af39/AAAAAAAAAAAAAAAAAAAAAAAAAAAAIQAAABgAAAAUAAAAwRoAAPoUAAD6NgAAtCUAABAAAAAmAAAACAAAAD2wAAAAAAAA"/>
+                <pr:smNativeData xmlns:pr="smNativeData" xmlns="smNativeData" val="SMDATA_15_FUV5ZhMAAAAlAAAAZAAAAA0AAAAAkAAAAJAAAACQAAAAkAAAAAAAAAAAAAAAAAAAAAEAAABQAAAAAAAAAAAA4D8AAAAAAADgPwAAAAAAAOA/AAAAAAAA4D8AAAAAAADgPwAAAAAAAOA/AAAAAAAA4D8AAAAAAADgPwAAAAAAAOA/AAAAAAAA4D8CAAAAjAAAAAAAAAAAAAAAQoX0DP///wgAAAAAAAAAAAAAAAAAAAAAAAAAAAAAAAAAAAAAZAAAAAEAAABAAAAAAAAAAAAAAAAAAAAAAAAAAAAAAAAAAAAAAAAAAAAAAAAAAAAAAAAAAAAAAAAAAAAAAAAAAAAAAAAAAAAAAAAAAAAAAAAAAAAAAAAAAAAAAAAAAAAAFAAAADwAAAAAAAAAAAAAAAAAAAkUAAAAAQAAABQAAAAUAAAAFAAAAAEAAAAAAAAAZAAAAGQAAAAAAAAAZAAAAGQAAAAVAAAAYAAAAAAAAAAAAAAADwAAACADAAAAAAAAAAAAAAEAAACgMgAAVgcAAKr4//8BAAAAf39/AAEAAABkAAAAAAAAABQAAABAHwAAAAAAACYAAAAAAAAAwOD//wAAAAAmAAAAZAAAABYAAABMAAAAAAAAAAAAAAAEAAAAAAAAAAEAAABZWVkKAAAAACgAAAAoAAAAZAAAAGQAAAAAAAAAzMzMAAAAAABQAAAAUAAAAGQAAABkAAAAAAAAABcAAAAUAAAAAAAAAAAAAAD/fwAA/38AAAAAAAAJAAAABAAAAAAAAAAeAAAAaAAAAAAAAAAAAAAAAAAAAAAAAAAAAAAAECcAABAnAAAAAAAAAAAAAAAAAAAAAAAAAAAAAAAAAAAAAAAAAAAAABQAAAAAAAAAwMD/AAAAAABkAAAAMgAAAAAAAABkAAAAAAAAAH9/fwAKAAAAIgAAABgAAAAAAAAAAAAAAAAAAAAAAAAAAAAAAAAAAAAkAAAAJAAAAAAAAAAHAAAAAAAAAAAAAAAAAAAAAAAAAAAAAAAAAAAAf39/ACUAAABYAAAAAAAAAAAAAAAAAAAAAAAAAAAAAAAAAAAAAAAAAAAAAAAAAAAAAAAAAAAAAAA/AAAAAAAAAKCGAQAAAAAAAAAAAAAAAAAMAAAAAQAAAAAAAAAAAAAAAAAAAB8AAABUAAAAAAAABQAAAAEAAAAAAAAAAAAAAAAAAAAAAAAAAAAAAAAAAAAAAAAAAAAAAAJ/f38AAAAAA8zMzADAwP8Af39/AAAAAAAAAAAAAAAAAAAAAAAAAAAAIQAAABgAAAAUAAAAwRoAAPoUAAD6NgAAtCUAABAAAAAmAAAACAAAAD2wAAAAAAAA"/>
               </a:ext>
             </a:extLst>
           </p:cNvSpPr>
@@ -6988,7 +6988,7 @@
           <p:cNvSpPr>
             <a:extLst>
               <a:ext uri="smNativeData">
-                <pr:smNativeData xmlns:pr="smNativeData" xmlns="smNativeData" val="SMDATA_15_LkR5ZhMAAAAlAAAAZAAAAA0AAAAAkAAAAJAAAACQAAAAkAAAAAAAAAABAAAAAAAAAAEAAABQAAAAAAAAAAAA4D8AAAAAAADgPwAAAAAAAOA/AAAAAAAA4D8AAAAAAADgPwAAAAAAAOA/AAAAAAAA4D8AAAAAAADgPwAAAAAAAOA/AAAAAAAA4D8CAAAAjAAAAAEAAAAAAAAA8/PzAP///wgAAAAAAAAAAAAAAAAAAAAAAAAAAAAAAAAAAAAAeAAAAAEAAABAAAAAAAAAAAAAAABaAAAAAAAAAAAAAAAAAAAAAAAAAAAAAAAAAAAAAAAAAAAAAAAAAAAAAAAAAAAAAAAAAAAAAAAAAAAAAAAAAAAAAAAAAAAAAAAAAAAAFAAAADwAAAAAAAAAAAAAAAAAAAkUAAAAAQAAABQAAAAUAAAAFAAAAAEAAAAAAAAAZAAAAGQAAAAAAAAAZAAAAGQAAAAVAAAAYAAAAAAAAAAAAAAADwAAACADAAAAAAAAAAAAAAEAAACgMgAAVgcAAKr4//8BAAAAf39/AAEAAABkAAAAAAAAABQAAABAHwAAAAAAACYAAAAAAAAAwOD//wAAAAAmAAAAZAAAABYAAABMAAAAAAAAAAAAAAAEAAAAAAAAAAEAAABZWVkKAAAAACgAAAAoAAAAZAAAAGQAAAAAAAAAzMzMAAAAAABQAAAAUAAAAGQAAABkAAAAAAAAABcAAAAUAAAAAAAAAAAAAAD/fwAA/38AAAAAAAAJAAAABAAAAAAAAAAeAAAAaAAAAAAAAAAAAAAAAAAAAAAAAAAAAAAAECcAABAnAAAAAAAAAAAAAAAAAAAAAAAAAAAAAAAAAAAAAAAAAAAAABQAAAAAAAAAwMD/AAAAAABkAAAAMgAAAAAAAABkAAAAAAAAAH9/fwAKAAAAIgAAABgAAAAAAAAAAAAAAAAAAAAAAAAAAAAAAAAAAAAkAAAAJAAAAAAAAAAHAAAAAAAAAAAAAAAAAAAAAAAAAAAAAAAAAAAAf39/ACUAAABYAAAAAAAAAAAAAAAAAAAAAAAAAAAAAAAAAAAAAAAAAAAAAAAAAAAAAAAAAAAAAAA/AAAAAAAAAKCGAQAAAAAAAAAAAAAAAAAMAAAAAQAAAAAAAAAAAAAAAAAAAB8AAABUAAAA8/PzAAAAAAEAAAAAAAAAAAAAAAAAAAAAAAAAAAAAAAAAAAAAAAAAAAAAAAJ/f38AAAAAA8zMzADAwP8Af39/AAAAAAAAAAAAAAAAAAAAAAAAAAAAIQAAABgAAAAUAAAAIBwAAAAAAABAOAAAMCoAABAAAAAmAAAACAAAAP//////////"/>
+                <pr:smNativeData xmlns:pr="smNativeData" xmlns="smNativeData" val="SMDATA_15_FUV5ZhMAAAAlAAAAZAAAAA0AAAAAkAAAAJAAAACQAAAAkAAAAAAAAAABAAAAAAAAAAEAAABQAAAAAAAAAAAA4D8AAAAAAADgPwAAAAAAAOA/AAAAAAAA4D8AAAAAAADgPwAAAAAAAOA/AAAAAAAA4D8AAAAAAADgPwAAAAAAAOA/AAAAAAAA4D8CAAAAjAAAAAEAAAAAAAAA8/PzAP///wgAAAAAAAAAAAAAAAAAAAAAAAAAAAAAAAAAAAAAeAAAAAEAAABAAAAAAAAAAAAAAABaAAAAAAAAAAAAAAAAAAAAAAAAAAAAAAAAAAAAAAAAAAAAAAAAAAAAAAAAAAAAAAAAAAAAAAAAAAAAAAAAAAAAAAAAAAAAAAAAAAAAFAAAADwAAAAAAAAAAAAAAAAAAAkUAAAAAQAAABQAAAAUAAAAFAAAAAEAAAAAAAAAZAAAAGQAAAAAAAAAZAAAAGQAAAAVAAAAYAAAAAAAAAAAAAAADwAAACADAAAAAAAAAAAAAAEAAACgMgAAVgcAAKr4//8BAAAAf39/AAEAAABkAAAAAAAAABQAAABAHwAAAAAAACYAAAAAAAAAwOD//wAAAAAmAAAAZAAAABYAAABMAAAAAAAAAAAAAAAEAAAAAAAAAAEAAABZWVkKAAAAACgAAAAoAAAAZAAAAGQAAAAAAAAAzMzMAAAAAABQAAAAUAAAAGQAAABkAAAAAAAAABcAAAAUAAAAAAAAAAAAAAD/fwAA/38AAAAAAAAJAAAABAAAAAAAAAAeAAAAaAAAAAAAAAAAAAAAAAAAAAAAAAAAAAAAECcAABAnAAAAAAAAAAAAAAAAAAAAAAAAAAAAAAAAAAAAAAAAAAAAABQAAAAAAAAAwMD/AAAAAABkAAAAMgAAAAAAAABkAAAAAAAAAH9/fwAKAAAAIgAAABgAAAAAAAAAAAAAAAAAAAAAAAAAAAAAAAAAAAAkAAAAJAAAAAAAAAAHAAAAAAAAAAAAAAAAAAAAAAAAAAAAAAAAAAAAf39/ACUAAABYAAAAAAAAAAAAAAAAAAAAAAAAAAAAAAAAAAAAAAAAAAAAAAAAAAAAAAAAAAAAAAA/AAAAAAAAAKCGAQAAAAAAAAAAAAAAAAAMAAAAAQAAAAAAAAAAAAAAAAAAAB8AAABUAAAA8/PzAAAAAAEAAAAAAAAAAAAAAAAAAAAAAAAAAAAAAAAAAAAAAAAAAAAAAAJ/f38AAAAAA8zMzADAwP8Af39/AAAAAAAAAAAAAAAAAAAAAAAAAAAAIQAAABgAAAAUAAAAIBwAAAAAAABAOAAAMCoAABAAAAAmAAAACAAAAP//////////"/>
               </a:ext>
             </a:extLst>
           </p:cNvSpPr>
@@ -7033,7 +7033,7 @@
             <a:spLocks noGrp="1" noChangeArrowheads="1"/>
             <a:extLst>
               <a:ext uri="smNativeData">
-                <pr:smNativeData xmlns:pr="smNativeData" xmlns="smNativeData" val="SMDATA_15_LkR5ZhMAAAAlAAAAZAAAAA0AAAAAkAAAAJAAAACQAAAAkAAAAAAAAAACAAAAAAAAAAEAAABQAAAAAAAAAAAA4D8AAAAAAADgPwAAAAAAAOA/AAAAAAAA4D8AAAAAAADgPwAAAAAAAOA/AAAAAAAA4D8AAAAAAADgPwAAAAAAAOA/AAAAAAAA4D8CAAAAjAAAAAAAAAAAAAAAQoX0DP///wgAAAAAAAAAAAAAAAAAAAAAAAAAAAAAAAAAAAAAZAAAAAEAAABAAAAAAAAAAAAAAAAAAAAAAAAAAAAAAAAAAAAAAAAAAAAAAAAAAAAAAAAAAAAAAAAAAAAAAAAAAAAAAAAAAAAAAAAAAAAAAAAAAAAAAAAAAAAAAAAAAAAAFAAAADwAAAAAAAAAAAAAAAAAAAkUAAAAAQAAABQAAAAUAAAAFAAAAAEAAAAAAAAAZAAAAGQAAAAAAAAAZAAAAGQAAAAVAAAAYAAAAAAAAAAAAAAADwAAACADAAAAAAAAAAAAAAEAAACgMgAAVgcAAKr4//8BAAAAf39/AAEAAABkAAAAAAAAABQAAABAHwAAAAAAACYAAAAAAAAAwOD//wAAAAAmAAAAZAAAABYAAABMAAAAAAAAAAAAAAAEAAAAAAAAAAEAAABZWVkKAAAAACgAAAAoAAAAZAAAAGQAAAAAAAAAzMzMAAAAAABQAAAAUAAAAGQAAABkAAAAAAAAABcAAAAUAAAAAAAAAAAAAAD/fwAA/38AAAAAAAAJAAAABAAAAAAAAAAeAAAAaAAAAAAAAAAAAAAAAAAAAAAAAAAAAAAAECcAABAnAAAAAAAAAAAAAAAAAAAAAAAAAAAAAAAAAAAAAAAAAAAAABQAAAAAAAAAwMD/AAAAAABkAAAAMgAAAAAAAABkAAAAAAAAAH9/fwAKAAAAIgAAABgAAAAAAAAAAAAAAAAAAAAAAAAAAAAAAAAAAAAkAAAAJAAAAAAAAAAHAAAAAAAAAAAAAAAAAAAAAAAAAAAAAAAAAAAAf39/ACUAAABYAAAAAAAAAAAAAAAAAAAAAAAAAAAAAAAAAAAAAAAAAAAAAAAAAAAAAAAAAAAAAAA/AAAAAAAAAKCGAQAAAAAAAAAAAAAAAAAMAAAAAQAAAAAAAAAAAAAAAAAAAB8AAABUAAAAAAAABQAAAAEAAAAAAAAAAAAAAAAAAAAAAAAAAAAAAAAAAAAAAAAAAAAAAAJ/f38AAAAAA8zMzADAwP8Af39/AAAAAAAAAAAAAAAAAAAAAAAAAAAAIQAAABgAAAAUAAAAvwMAAAQKAACiHAAALBYAABAAAAAmAAAACAAAAL2wAAAAAAAA"/>
+                <pr:smNativeData xmlns:pr="smNativeData" xmlns="smNativeData" val="SMDATA_15_FUV5ZhMAAAAlAAAAZAAAAA0AAAAAkAAAAJAAAACQAAAAkAAAAAAAAAACAAAAAAAAAAEAAABQAAAAAAAAAAAA4D8AAAAAAADgPwAAAAAAAOA/AAAAAAAA4D8AAAAAAADgPwAAAAAAAOA/AAAAAAAA4D8AAAAAAADgPwAAAAAAAOA/AAAAAAAA4D8CAAAAjAAAAAAAAAAAAAAAQoX0DP///wgAAAAAAAAAAAAAAAAAAAAAAAAAAAAAAAAAAAAAZAAAAAEAAABAAAAAAAAAAAAAAAAAAAAAAAAAAAAAAAAAAAAAAAAAAAAAAAAAAAAAAAAAAAAAAAAAAAAAAAAAAAAAAAAAAAAAAAAAAAAAAAAAAAAAAAAAAAAAAAAAAAAAFAAAADwAAAAAAAAAAAAAAAAAAAkUAAAAAQAAABQAAAAUAAAAFAAAAAEAAAAAAAAAZAAAAGQAAAAAAAAAZAAAAGQAAAAVAAAAYAAAAAAAAAAAAAAADwAAACADAAAAAAAAAAAAAAEAAACgMgAAVgcAAKr4//8BAAAAf39/AAEAAABkAAAAAAAAABQAAABAHwAAAAAAACYAAAAAAAAAwOD//wAAAAAmAAAAZAAAABYAAABMAAAAAAAAAAAAAAAEAAAAAAAAAAEAAABZWVkKAAAAACgAAAAoAAAAZAAAAGQAAAAAAAAAzMzMAAAAAABQAAAAUAAAAGQAAABkAAAAAAAAABcAAAAUAAAAAAAAAAAAAAD/fwAA/38AAAAAAAAJAAAABAAAAAAAAAAeAAAAaAAAAAAAAAAAAAAAAAAAAAAAAAAAAAAAECcAABAnAAAAAAAAAAAAAAAAAAAAAAAAAAAAAAAAAAAAAAAAAAAAABQAAAAAAAAAwMD/AAAAAABkAAAAMgAAAAAAAABkAAAAAAAAAH9/fwAKAAAAIgAAABgAAAAAAAAAAAAAAAAAAAAAAAAAAAAAAAAAAAAkAAAAJAAAAAAAAAAHAAAAAAAAAAAAAAAAAAAAAAAAAAAAAAAAAAAAf39/ACUAAABYAAAAAAAAAAAAAAAAAAAAAAAAAAAAAAAAAAAAAAAAAAAAAAAAAAAAAAAAAAAAAAA/AAAAAAAAAKCGAQAAAAAAAAAAAAAAAAAMAAAAAQAAAAAAAAAAAAAAAAAAAB8AAABUAAAAAAAABQAAAAEAAAAAAAAAAAAAAAAAAAAAAAAAAAAAAAAAAAAAAAAAAAAAAAJ/f38AAAAAA8zMzADAwP8Af39/AAAAAAAAAAAAAAAAAAAAAAAAAAAAIQAAABgAAAAUAAAAvwMAAAQKAACiHAAALBYAABAAAAAmAAAACAAAAL2wAAAAAAAA"/>
               </a:ext>
             </a:extLst>
           </p:cNvSpPr>
@@ -7157,7 +7157,7 @@
             <a:spLocks noGrp="1" noChangeArrowheads="1"/>
             <a:extLst>
               <a:ext uri="smNativeData">
-                <pr:smNativeData xmlns:pr="smNativeData" xmlns="smNativeData" val="SMDATA_15_LkR5ZhMAAAAlAAAAZAAAAA0AAAAAkAAAAJAAAACQAAAAkAAAAAAAAAAAAAAAAAAAAAEAAABQAAAAAAAAAAAA4D8AAAAAAADgPwAAAAAAAOA/AAAAAAAA4D8AAAAAAADgPwAAAAAAAOA/AAAAAAAA4D8AAAAAAADgPwAAAAAAAOA/AAAAAAAA4D8CAAAAjAAAAAAAAAAAAAAAQoX0DP///wgAAAAAAAAAAAAAAAAAAAAAAAAAAAAAAAAAAAAAZAAAAAEAAABAAAAAAAAAAAAAAAAAAAAAAAAAAAAAAAAAAAAAAAAAAAAAAAAAAAAAAAAAAAAAAAAAAAAAAAAAAAAAAAAAAAAAAAAAAAAAAAAAAAAAAAAAAAAAAAAAAAAAFAAAADwAAAAAAAAAAAAAAAAAAAkUAAAAAQAAABQAAAAUAAAAFAAAAAEAAAAAAAAAZAAAAGQAAAAAAAAAZAAAAGQAAAAVAAAAYAAAAAAAAAAAAAAADwAAACADAAAAAAAAAAAAAAEAAACgMgAAVgcAAKr4//8BAAAAf39/AAEAAABkAAAAAAAAABQAAABAHwAAAAAAACYAAAAAAAAAwOD//wAAAAAmAAAAZAAAABYAAABMAAAAAAAAAAAAAAAEAAAAAAAAAAEAAABZWVkKAAAAACgAAAAoAAAAZAAAAGQAAAAAAAAAzMzMAAAAAABQAAAAUAAAAGQAAABkAAAAAAAAABcAAAAUAAAAAAAAAAAAAAD/fwAA/38AAAAAAAAJAAAABAAAAAAAAAAeAAAAaAAAAAAAAAAAAAAAAAAAAAAAAAAAAAAAECcAABAnAAAAAAAAAAAAAAAAAAAAAAAAAAAAAAAAAAAAAAAAAAAAABQAAAAAAAAAwMD/AAAAAABkAAAAMgAAAAAAAABkAAAAAAAAAH9/fwAKAAAAIgAAABgAAAAAAAAAAAAAAAAAAAAAAAAAAAAAAAAAAAAkAAAAJAAAAAAAAAAHAAAAAAAAAAAAAAAAAAAAAAAAAAAAAAAAAAAAf39/ACUAAABYAAAAAAAAAAAAAAAAAAAAAAAAAAAAAAAAAAAAAAAAAAAAAAAAAAAAAAAAAAAAAAA/AAAAAAAAAKCGAQAAAAAAAAAAAAAAAAAMAAAAAQAAAAAAAAAAAAAAAAAAAB8AAABUAAAAAAAABQAAAAEAAAAAAAAAAAAAAAAAAAAAAAAAAAAAAAAAAAAAAAAAAAAAAAJ/f38AAAAAA8zMzADAwP8Af39/AAAAAAAAAAAAAAAAAAAAAAAAAAAAIQAAABgAAAAUAAAAvwMAAOsXAACiHAAADSIAABAAAAAmAAAACAAAAD2wAAAAAAAA"/>
+                <pr:smNativeData xmlns:pr="smNativeData" xmlns="smNativeData" val="SMDATA_15_FUV5ZhMAAAAlAAAAZAAAAA0AAAAAkAAAAJAAAACQAAAAkAAAAAAAAAAAAAAAAAAAAAEAAABQAAAAAAAAAAAA4D8AAAAAAADgPwAAAAAAAOA/AAAAAAAA4D8AAAAAAADgPwAAAAAAAOA/AAAAAAAA4D8AAAAAAADgPwAAAAAAAOA/AAAAAAAA4D8CAAAAjAAAAAAAAAAAAAAAQoX0DP///wgAAAAAAAAAAAAAAAAAAAAAAAAAAAAAAAAAAAAAZAAAAAEAAABAAAAAAAAAAAAAAAAAAAAAAAAAAAAAAAAAAAAAAAAAAAAAAAAAAAAAAAAAAAAAAAAAAAAAAAAAAAAAAAAAAAAAAAAAAAAAAAAAAAAAAAAAAAAAAAAAAAAAFAAAADwAAAAAAAAAAAAAAAAAAAkUAAAAAQAAABQAAAAUAAAAFAAAAAEAAAAAAAAAZAAAAGQAAAAAAAAAZAAAAGQAAAAVAAAAYAAAAAAAAAAAAAAADwAAACADAAAAAAAAAAAAAAEAAACgMgAAVgcAAKr4//8BAAAAf39/AAEAAABkAAAAAAAAABQAAABAHwAAAAAAACYAAAAAAAAAwOD//wAAAAAmAAAAZAAAABYAAABMAAAAAAAAAAAAAAAEAAAAAAAAAAEAAABZWVkKAAAAACgAAAAoAAAAZAAAAGQAAAAAAAAAzMzMAAAAAABQAAAAUAAAAGQAAABkAAAAAAAAABcAAAAUAAAAAAAAAAAAAAD/fwAA/38AAAAAAAAJAAAABAAAAAAAAAAeAAAAaAAAAAAAAAAAAAAAAAAAAAAAAAAAAAAAECcAABAnAAAAAAAAAAAAAAAAAAAAAAAAAAAAAAAAAAAAAAAAAAAAABQAAAAAAAAAwMD/AAAAAABkAAAAMgAAAAAAAABkAAAAAAAAAH9/fwAKAAAAIgAAABgAAAAAAAAAAAAAAAAAAAAAAAAAAAAAAAAAAAAkAAAAJAAAAAAAAAAHAAAAAAAAAAAAAAAAAAAAAAAAAAAAAAAAAAAAf39/ACUAAABYAAAAAAAAAAAAAAAAAAAAAAAAAAAAAAAAAAAAAAAAAAAAAAAAAAAAAAAAAAAAAAA/AAAAAAAAAKCGAQAAAAAAAAAAAAAAAAAMAAAAAQAAAAAAAAAAAAAAAAAAAB8AAABUAAAAAAAABQAAAAEAAAAAAAAAAAAAAAAAAAAAAAAAAAAAAAAAAAAAAAAAAAAAAAJ/f38AAAAAA8zMzADAwP8Af39/AAAAAAAAAAAAAAAAAAAAAAAAAAAAIQAAABgAAAAUAAAAvwMAAOsXAACiHAAADSIAABAAAAAmAAAACAAAAD2wAAAAAAAA"/>
               </a:ext>
             </a:extLst>
           </p:cNvSpPr>
@@ -7308,7 +7308,7 @@
             <a:spLocks noGrp="1" noChangeArrowheads="1"/>
             <a:extLst>
               <a:ext uri="smNativeData">
-                <pr:smNativeData xmlns:pr="smNativeData" xmlns="smNativeData" val="SMDATA_15_LkR5ZhMAAAAlAAAAZAAAAA0AAAAAkAAAAJAAAACQAAAAkAAAAAAAAAABAAAAAAAAAAEAAABQAAAAAAAAAAAA4D8AAAAAAADgPwAAAAAAAOA/AAAAAAAA4D8AAAAAAADgPwAAAAAAAOA/AAAAAAAA4D8AAAAAAADgPwAAAAAAAOA/AAAAAAAA4D8CAAAAjAAAAAAAAAAAAAAAQoX0DP///wgAAAAAAAAAAAAAAAAAAAAAAAAAAAAAAAAAAAAAZAAAAAEAAABAAAAAAAAAAAAAAAAAAAAAAAAAAAAAAAAAAAAAAAAAAAAAAAAAAAAAAAAAAAAAAAAAAAAAAAAAAAAAAAAAAAAAAAAAAAAAAAAAAAAAAAAAAAAAAAAAAAAAFAAAADwAAAAAAAAAAAAAAAAAAAkUAAAAAQAAABQAAAAUAAAAFAAAAAEAAAAAAAAAZAAAAGQAAAAAAAAAZAAAAGQAAAAVAAAAYAAAAAAAAAAAAAAADwAAACADAAAAAAAAAAAAAAEAAACgMgAAVgcAAKr4//8BAAAAf39/AAEAAABkAAAAAAAAABQAAABAHwAAAAAAACYAAAAAAAAAwOD//wAAAAAmAAAAZAAAABYAAABMAAAAAAAAAAAAAAAEAAAAAAAAAAEAAABZWVkKAAAAACgAAAAoAAAAZAAAAGQAAAAAAAAAzMzMAAAAAABQAAAAUAAAAGQAAABkAAAAAAAAABcAAAAUAAAAAAAAAAAAAAD/fwAA/38AAAAAAAAJAAAABAAAAAAAAMAeAAAAaAAAAAAAAAAAAAAAAAAAAAAAAAAAAAAAECcAABAnAAAAAAAAAAAAAAAAAAAAAAAAAAAAAAAAAAAAAAAAAAAAABQAAAAAAAAAwMD/AAAAAABkAAAAMgAAAAAAAABkAAAAAAAAAH9/fwAKAAAAIgAAABgAAAAAAAAAAAAAAAAAAAAAAAAAAAAAAAAAAAAkAAAAJAAAAAAAAAAHAAAAAAAAAAAAAAAAAAAAAAAAAAAAAAAAAAAAf39/ACUAAABYAAAAAAAAAAAAAAAAAAAAAAAAAAAAAAAAAAAAAAAAAAAAAAAAAAAAAAAAAAAAAAA/AAAAAAAAAKCGAQAAAAAAAAAAAAAAAAAMAAAAAQAAAAAAAAAAAAAAAAAAAB8AAABUAAAAAAAABQAAAAEAAAAAAAAAAAAAAAAAAAAAAAAAAAAAAAAAAAAAAAAAAAAAAAJ/f38AAAAAA8zMzADAwP8Af39/AAAAAAAAAAAAAAAAAAAAAAAAAAAAIQAAABgAAAAUAAAAYx4AAPAFAAD9NQAAPyQAABAAAAAmAAAACAAAAL2wAAAAAAAA"/>
+                <pr:smNativeData xmlns:pr="smNativeData" xmlns="smNativeData" val="SMDATA_15_FUV5ZhMAAAAlAAAAZAAAAA0AAAAAkAAAAJAAAACQAAAAkAAAAAAAAAABAAAAAAAAAAEAAABQAAAAAAAAAAAA4D8AAAAAAADgPwAAAAAAAOA/AAAAAAAA4D8AAAAAAADgPwAAAAAAAOA/AAAAAAAA4D8AAAAAAADgPwAAAAAAAOA/AAAAAAAA4D8CAAAAjAAAAAAAAAAAAAAAQoX0DP///wgAAAAAAAAAAAAAAAAAAAAAAAAAAAAAAAAAAAAAZAAAAAEAAABAAAAAAAAAAAAAAAAAAAAAAAAAAAAAAAAAAAAAAAAAAAAAAAAAAAAAAAAAAAAAAAAAAAAAAAAAAAAAAAAAAAAAAAAAAAAAAAAAAAAAAAAAAAAAAAAAAAAAFAAAADwAAAAAAAAAAAAAAAAAAAkUAAAAAQAAABQAAAAUAAAAFAAAAAEAAAAAAAAAZAAAAGQAAAAAAAAAZAAAAGQAAAAVAAAAYAAAAAAAAAAAAAAADwAAACADAAAAAAAAAAAAAAEAAACgMgAAVgcAAKr4//8BAAAAf39/AAEAAABkAAAAAAAAABQAAABAHwAAAAAAACYAAAAAAAAAwOD//wAAAAAmAAAAZAAAABYAAABMAAAAAAAAAAAAAAAEAAAAAAAAAAEAAABZWVkKAAAAACgAAAAoAAAAZAAAAGQAAAAAAAAAzMzMAAAAAABQAAAAUAAAAGQAAABkAAAAAAAAABcAAAAUAAAAAAAAAAAAAAD/fwAA/38AAAAAAAAJAAAABAAAAAAAAMAeAAAAaAAAAAAAAAAAAAAAAAAAAAAAAAAAAAAAECcAABAnAAAAAAAAAAAAAAAAAAAAAAAAAAAAAAAAAAAAAAAAAAAAABQAAAAAAAAAwMD/AAAAAABkAAAAMgAAAAAAAABkAAAAAAAAAH9/fwAKAAAAIgAAABgAAAAAAAAAAAAAAAAAAAAAAAAAAAAAAAAAAAAkAAAAJAAAAAAAAAAHAAAAAAAAAAAAAAAAAAAAAAAAAAAAAAAAAAAAf39/ACUAAABYAAAAAAAAAAAAAAAAAAAAAAAAAAAAAAAAAAAAAAAAAAAAAAAAAAAAAAAAAAAAAAA/AAAAAAAAAKCGAQAAAAAAAAAAAAAAAAAMAAAAAQAAAAAAAAAAAAAAAAAAAB8AAABUAAAAAAAABQAAAAEAAAAAAAAAAAAAAAAAAAAAAAAAAAAAAAAAAAAAAAAAAAAAAAJ/f38AAAAAA8zMzADAwP8Af39/AAAAAAAAAAAAAAAAAAAAAAAAAAAAIQAAABgAAAAUAAAAYx4AAPAFAAD9NQAAPyQAABAAAAAmAAAACAAAAL2wAAAAAAAA"/>
               </a:ext>
             </a:extLst>
           </p:cNvSpPr>
@@ -7432,7 +7432,7 @@
             <a:spLocks noGrp="1" noChangeArrowheads="1"/>
             <a:extLst>
               <a:ext uri="smNativeData">
-                <pr:smNativeData xmlns:pr="smNativeData" xmlns="smNativeData" val="SMDATA_15_LkR5ZhMAAAAlAAAAZAAAAA0AAAAAkAAAAJAAAACQAAAAkAAAAAAAAAABAAAAAAAAAAEAAABQAAAAAAAAAAAA4D8AAAAAAADgPwAAAAAAAOA/AAAAAAAA4D8AAAAAAADgPwAAAAAAAOA/AAAAAAAA4D8AAAAAAADgPwAAAAAAAOA/AAAAAAAA4D8CAAAAjAAAAAAAAAAAAAAAQoX0DP///wgAAAAAAAAAAAAAAAAAAAAAAAAAAAAAAAAAAAAAZAAAAAEAAABAAAAAAAAAAAAAAAAAAAAAAAAAAAAAAAAAAAAAAAAAAAAAAAAAAAAAAAAAAAAAAAAAAAAAAAAAAAAAAAAAAAAAAAAAAAAAAAAAAAAAAAAAAAAAAAAAAAAAFAAAADwAAAAAAAAAAAAAAAAAAAkUAAAAAQAAABQAAAAUAAAAFAAAAAEAAAAAAAAAZAAAAGQAAAAAAAAAZAAAAGQAAAAVAAAAYAAAAAAAAAAAAAAADwAAACADAAAAAAAAAAAAAAEAAACgMgAAVgcAAKr4//8BAAAAf39/AAEAAABkAAAAAAAAABQAAABAHwAAAAAAACYAAAAAAAAAwOD//wAAAAAmAAAAZAAAABYAAABMAAAAAAAAAAAAAAAEAAAAAAAAAAEAAABZWVkKAAAAACgAAAAoAAAAZAAAAGQAAAAAAAAAzMzMAAAAAABQAAAAUAAAAGQAAABkAAAAAAAAABcAAAAUAAAAAAAAAAAAAAD/fwAA/38AAAAAAAAJAAAABAAAAAAAAAAeAAAAaAAAAAAAAAAAAAAAAAAAAAAAAAAAAAAAECcAABAnAAAAAAAAAAAAAAAAAAAAAAAAAAAAAAAAAAAAAAAAAAAAABQAAAAAAAAAwMD/AAAAAABkAAAAMgAAAAAAAABkAAAAAAAAAH9/fwAKAAAAIgAAABgAAAAAAAAAAAAAAAAAAAAAAAAAAAAAAAAAAAAkAAAAJAAAAAAAAAAHAAAAAAAAAAAAAAAAAAAAAAAAAAAAAAAAAAAAf39/ACUAAABYAAAAAAAAAAAAAAAAAAAAAAAAAAAAAAAAAAAAAAAAAAAAAAAAAAAAAAAAAAAAAAA/AAAAAAAAAKCGAQAAAAAAAAAAAAAAAAAMAAAAAQAAAAAAAAAAAAAAAAAAAB8AAABUAAAAAAAABQAAAAEAAAAAAAAAAAAAAAAAAAAAAAAAAAAAAAAAAAAAAAAAAAAAAAJ/f38AAAAAA8zMzADAwP8Af39/AAAAAAAAAAAAAAAAAAAAAAAAAAAAIQAAABgAAAAUAAAAHjQAAEAmAAB/NwAAeikAABAAAAAmAAAACAAAADywAAAAAAAA"/>
+                <pr:smNativeData xmlns:pr="smNativeData" xmlns="smNativeData" val="SMDATA_15_FUV5ZhMAAAAlAAAAZAAAAA0AAAAAkAAAAJAAAACQAAAAkAAAAAAAAAABAAAAAAAAAAEAAABQAAAAAAAAAAAA4D8AAAAAAADgPwAAAAAAAOA/AAAAAAAA4D8AAAAAAADgPwAAAAAAAOA/AAAAAAAA4D8AAAAAAADgPwAAAAAAAOA/AAAAAAAA4D8CAAAAjAAAAAAAAAAAAAAAQoX0DP///wgAAAAAAAAAAAAAAAAAAAAAAAAAAAAAAAAAAAAAZAAAAAEAAABAAAAAAAAAAAAAAAAAAAAAAAAAAAAAAAAAAAAAAAAAAAAAAAAAAAAAAAAAAAAAAAAAAAAAAAAAAAAAAAAAAAAAAAAAAAAAAAAAAAAAAAAAAAAAAAAAAAAAFAAAADwAAAAAAAAAAAAAAAAAAAkUAAAAAQAAABQAAAAUAAAAFAAAAAEAAAAAAAAAZAAAAGQAAAAAAAAAZAAAAGQAAAAVAAAAYAAAAAAAAAAAAAAADwAAACADAAAAAAAAAAAAAAEAAACgMgAAVgcAAKr4//8BAAAAf39/AAEAAABkAAAAAAAAABQAAABAHwAAAAAAACYAAAAAAAAAwOD//wAAAAAmAAAAZAAAABYAAABMAAAAAAAAAAAAAAAEAAAAAAAAAAEAAABZWVkKAAAAACgAAAAoAAAAZAAAAGQAAAAAAAAAzMzMAAAAAABQAAAAUAAAAGQAAABkAAAAAAAAABcAAAAUAAAAAAAAAAAAAAD/fwAA/38AAAAAAAAJAAAABAAAAAAAAAAeAAAAaAAAAAAAAAAAAAAAAAAAAAAAAAAAAAAAECcAABAnAAAAAAAAAAAAAAAAAAAAAAAAAAAAAAAAAAAAAAAAAAAAABQAAAAAAAAAwMD/AAAAAABkAAAAMgAAAAAAAABkAAAAAAAAAH9/fwAKAAAAIgAAABgAAAAAAAAAAAAAAAAAAAAAAAAAAAAAAAAAAAAkAAAAJAAAAAAAAAAHAAAAAAAAAAAAAAAAAAAAAAAAAAAAAAAAAAAAf39/ACUAAABYAAAAAAAAAAAAAAAAAAAAAAAAAAAAAAAAAAAAAAAAAAAAAAAAAAAAAAAAAAAAAAA/AAAAAAAAAKCGAQAAAAAAAAAAAAAAAAAMAAAAAQAAAAAAAAAAAAAAAAAAAB8AAABUAAAAAAAABQAAAAEAAAAAAAAAAAAAAAAAAAAAAAAAAAAAAAAAAAAAAAAAAAAAAAJ/f38AAAAAA8zMzADAwP8Af39/AAAAAAAAAAAAAAAAAAAAAAAAAAAAIQAAABgAAAAUAAAAHjQAAEAmAAB/NwAAeikAABAAAAAmAAAACAAAADywAAAAAAAA"/>
               </a:ext>
             </a:extLst>
           </p:cNvSpPr>
@@ -7486,7 +7486,7 @@
               </a:spcAft>
               <a:buNone/>
             </a:pPr>
-            <a:fld id="{3FDAA099-D7D2-8F56-9C62-2103EE2C6A74}" type="slidenum">
+            <a:fld id="{3FD914B5-FBD2-8CE2-9C61-0DB75A2F6A58}" type="slidenum">
               <a:rPr lang="ru-ru" cap="none"/>
               <a:t>‹#›</a:t>
             </a:fld>
@@ -7527,7 +7527,7 @@
             <a:spLocks noGrp="1" noChangeArrowheads="1"/>
             <a:extLst>
               <a:ext uri="smNativeData">
-                <pr:smNativeData xmlns:pr="smNativeData" xmlns="smNativeData" val="SMDATA_15_LkR5ZhMAAAAlAAAAZAAAAA0AAAAAkAAAAJAAAACQAAAAkAAAAAAAAAABAAAAAAAAAAEAAABQAAAAAAAAAAAA4D8AAAAAAADgPwAAAAAAAOA/AAAAAAAA4D8AAAAAAADgPwAAAAAAAOA/AAAAAAAA4D8AAAAAAADgPwAAAAAAAOA/AAAAAAAA4D8CAAAAjAAAAAAAAAAAAAAAQoX0DP///wgAAAAAAAAAAAAAAAAAAAAAAAAAAAAAAAAAAAAAZAAAAAEAAABAAAAAAAAAAAAAAAAAAAAAAAAAAAAAAAAAAAAAAAAAAAAAAAAAAAAAAAAAAAAAAAAAAAAAAAAAAAAAAAAAAAAAAAAAAAAAAAAAAAAAAAAAAAAAAAAAAAAAFAAAADwAAAAAAAAAAAAAAAAAAAkUAAAAAQAAABQAAAAUAAAAFAAAAAEAAAAAAAAAZAAAAGQAAAAAAAAAZAAAAGQAAAAVAAAAYAAAAAAAAAAAAAAADwAAACADAAAAAAAAAAAAAAEAAACgMgAAVgcAAKr4//8BAAAAf39/AAEAAABkAAAAAAAAABQAAABAHwAAAAAAACYAAAAAAAAAwOD//wAAAAAmAAAAZAAAABYAAABMAAAAAAAAAAAAAAAEAAAAAAAAAAEAAABZWVkKAAAAACgAAAAoAAAAZAAAAGQAAAAAAAAAzMzMAAAAAABQAAAAUAAAAGQAAABkAAAAAAAAABcAAAAUAAAAAAAAAAAAAAD/fwAA/38AAAAAAAAJAAAABAAAAAAAAAAeAAAAaAAAAAAAAAAAAAAAAAAAAAAAAAAAAAAAECcAABAnAAAAAAAAAAAAAAAAAAAAAAAAAAAAAAAAAAAAAAAAAAAAABQAAAAAAAAAwMD/AAAAAABkAAAAMgAAAAAAAABkAAAAAAAAAH9/fwAKAAAAIgAAABgAAAAAAAAAAAAAAAAAAAAAAAAAAAAAAAAAAAAkAAAAJAAAAAAAAAAHAAAAAAAAAAAAAAAAAAAAAAAAAAAAAAAAAAAAf39/ACUAAABYAAAAAAAAAAAAAAAAAAAAAAAAAAAAAAAAAAAAAAAAAAAAAAAAAAAAAAAAAAAAAAA/AAAAAAAAAKCGAQAAAAAAAAAAAAAAAAAMAAAAAQAAAAAAAAAAAAAAAAAAAB8AAABUAAAAAAAABQAAAAEAAAAAAAAAAAAAAAAAAAAAAAAAAAAAAAAAAAAAAAAAAAAAAAJ/f38AAAAAA8zMzADAwP8Af39/AAAAAAAAAAAAAAAAAAAAAAAAAAAAIQAAABgAAAAUAAAAHjQAAEAmAAB/NwAAeikAABAAAAAmAAAACAAAADywAAAAAAAA"/>
+                <pr:smNativeData xmlns:pr="smNativeData" xmlns="smNativeData" val="SMDATA_15_FUV5ZhMAAAAlAAAAZAAAAA0AAAAAkAAAAJAAAACQAAAAkAAAAAAAAAABAAAAAAAAAAEAAABQAAAAAAAAAAAA4D8AAAAAAADgPwAAAAAAAOA/AAAAAAAA4D8AAAAAAADgPwAAAAAAAOA/AAAAAAAA4D8AAAAAAADgPwAAAAAAAOA/AAAAAAAA4D8CAAAAjAAAAAAAAAAAAAAAQoX0DP///wgAAAAAAAAAAAAAAAAAAAAAAAAAAAAAAAAAAAAAZAAAAAEAAABAAAAAAAAAAAAAAAAAAAAAAAAAAAAAAAAAAAAAAAAAAAAAAAAAAAAAAAAAAAAAAAAAAAAAAAAAAAAAAAAAAAAAAAAAAAAAAAAAAAAAAAAAAAAAAAAAAAAAFAAAADwAAAAAAAAAAAAAAAAAAAkUAAAAAQAAABQAAAAUAAAAFAAAAAEAAAAAAAAAZAAAAGQAAAAAAAAAZAAAAGQAAAAVAAAAYAAAAAAAAAAAAAAADwAAACADAAAAAAAAAAAAAAEAAACgMgAAVgcAAKr4//8BAAAAf39/AAEAAABkAAAAAAAAABQAAABAHwAAAAAAACYAAAAAAAAAwOD//wAAAAAmAAAAZAAAABYAAABMAAAAAAAAAAAAAAAEAAAAAAAAAAEAAABZWVkKAAAAACgAAAAoAAAAZAAAAGQAAAAAAAAAzMzMAAAAAABQAAAAUAAAAGQAAABkAAAAAAAAABcAAAAUAAAAAAAAAAAAAAD/fwAA/38AAAAAAAAJAAAABAAAAAAAAAAeAAAAaAAAAAAAAAAAAAAAAAAAAAAAAAAAAAAAECcAABAnAAAAAAAAAAAAAAAAAAAAAAAAAAAAAAAAAAAAAAAAAAAAABQAAAAAAAAAwMD/AAAAAABkAAAAMgAAAAAAAABkAAAAAAAAAH9/fwAKAAAAIgAAABgAAAAAAAAAAAAAAAAAAAAAAAAAAAAAAAAAAAAkAAAAJAAAAAAAAAAHAAAAAAAAAAAAAAAAAAAAAAAAAAAAAAAAAAAAf39/ACUAAABYAAAAAAAAAAAAAAAAAAAAAAAAAAAAAAAAAAAAAAAAAAAAAAAAAAAAAAAAAAAAAAA/AAAAAAAAAKCGAQAAAAAAAAAAAAAAAAAMAAAAAQAAAAAAAAAAAAAAAAAAAB8AAABUAAAAAAAABQAAAAEAAAAAAAAAAAAAAAAAAAAAAAAAAAAAAAAAAAAAAAAAAAAAAAJ/f38AAAAAA8zMzADAwP8Af39/AAAAAAAAAAAAAAAAAAAAAAAAAAAAIQAAABgAAAAUAAAAHjQAAEAmAAB/NwAAeikAABAAAAAmAAAACAAAADywAAAAAAAA"/>
               </a:ext>
             </a:extLst>
           </p:cNvSpPr>
@@ -7581,7 +7581,7 @@
               </a:spcAft>
               <a:buNone/>
             </a:pPr>
-            <a:fld id="{3FDA96C6-88D2-8F60-9C62-7E35D82C6A2B}" type="slidenum">
+            <a:fld id="{3FD93973-3DD2-8CCF-9C61-CB9A772F6A9E}" type="slidenum">
               <a:rPr lang="ru-ru" cap="none"/>
               <a:t>‹#›</a:t>
             </a:fld>
@@ -7632,7 +7632,7 @@
             <a:spLocks noGrp="1" noChangeArrowheads="1"/>
             <a:extLst>
               <a:ext uri="smNativeData">
-                <pr:smNativeData xmlns:pr="smNativeData" xmlns="smNativeData" val="SMDATA_15_LkR5ZhMAAAAlAAAAZAAAAA0AAAAAkAAAAJAAAACQAAAAkAAAAAAAAAAAAAAAAAAAAAEAAABQAAAAAAAAAAAA4D8AAAAAAADgPwAAAAAAAOA/AAAAAAAA4D8AAAAAAADgPwAAAAAAAOA/AAAAAAAA4D8AAAAAAADgPwAAAAAAAOA/AAAAAAAA4D8CAAAAjAAAAAAAAAAAAAAAQoX0DP///wgAAAAAAAAAAAAAAAAAAAAAAAAAAAAAAAAAAAAAZAAAAAEAAABAAAAAAAAAAAAAAAAAAAAAAAAAAAAAAAAAAAAAAAAAAAAAAAAAAAAAAAAAAAAAAAAAAAAAAAAAAAAAAAAAAAAAAAAAAAAAAAAAAAAAAAAAAAAAAAAAAAAAFAAAADwAAAAAAAAAAAAAAAAAAAkUAAAAAQAAABQAAAAUAAAAFAAAAAEAAAAAAAAAZAAAAGQAAAAAAAAAZAAAAGQAAAAVAAAAYAAAAAAAAAAAAAAADwAAACADAAAAAAAAAAAAAAEAAACgMgAAVgcAAKr4//8BAAAAf39/AAEAAABkAAAAAAAAABQAAABAHwAAAAAAACYAAAAAAAAAwOD//wAAAAAmAAAAZAAAABYAAABMAAAAAAAAAAAAAAAEAAAAAAAAAAEAAABZWVkKAAAAACgAAAAoAAAAZAAAAGQAAAAAAAAAzMzMAAAAAABQAAAAUAAAAGQAAABkAAAAAAAAABcAAAAUAAAAAAAAAAAAAAD/fwAA/38AAAAAAAAJAAAABAAAAGdlODkeAAAAaAAAAAAAAAAAAAAAAAAAAAAAAAAAAAAAECcAABAnAAAAAAAAAAAAAAAAAAAAAAAAAAAAAAAAAAAAAAAAAAAAABQAAAAAAAAAwMD/AAAAAABkAAAAMgAAAAAAAABkAAAAAAAAAH9/fwAKAAAAIgAAABgAAAAAAAAAAAAAAAAAAAAAAAAAAAAAAAAAAAAkAAAAJAAAAAAAAAAHAAAAAAAAAAAAAAAAAAAAAAAAAAAAAAAAAAAAf39/ACUAAABYAAAAAAAAAAAAAAAAAAAAAAAAAAAAAAAAAAAAAAAAAAAAAAAAAAAAAAAAAAAAAAA/AAAAAAAAAKCGAQAAAAAAAAAAAAAAAAAMAAAAAQAAAAAAAAAAAAAAAAAAAB8AAABUAAAAAAAABQAAAAEAAAAAAAAAAAAAAAAAAAAAAAAAAAAAAAAAAAAAAAAAAAAAAAJ/f38AAAAAA8zMzADAwP8Af39/AAAAAAAAAAAAAAAAAAAAAAAAAAAAIQAAABgAAAAUAAAAFAMAALYCAAB/NwAAvwoAABAAAAAmAAAACAAAAL2/AAD/HwAA"/>
+                <pr:smNativeData xmlns:pr="smNativeData" xmlns="smNativeData" val="SMDATA_15_FUV5ZhMAAAAlAAAAZAAAAA0AAAAAkAAAAJAAAACQAAAAkAAAAAAAAAAAAAAAAAAAAAEAAABQAAAAAAAAAAAA4D8AAAAAAADgPwAAAAAAAOA/AAAAAAAA4D8AAAAAAADgPwAAAAAAAOA/AAAAAAAA4D8AAAAAAADgPwAAAAAAAOA/AAAAAAAA4D8CAAAAjAAAAAAAAAAAAAAAQoX0DP///wgAAAAAAAAAAAAAAAAAAAAAAAAAAAAAAAAAAAAAZAAAAAEAAABAAAAAAAAAAAAAAAAAAAAAAAAAAAAAAAAAAAAAAAAAAAAAAAAAAAAAAAAAAAAAAAAAAAAAAAAAAAAAAAAAAAAAAAAAAAAAAAAAAAAAAAAAAAAAAAAAAAAAFAAAADwAAAAAAAAAAAAAAAAAAAkUAAAAAQAAABQAAAAUAAAAFAAAAAEAAAAAAAAAZAAAAGQAAAAAAAAAZAAAAGQAAAAVAAAAYAAAAAAAAAAAAAAADwAAACADAAAAAAAAAAAAAAEAAACgMgAAVgcAAKr4//8BAAAAf39/AAEAAABkAAAAAAAAABQAAABAHwAAAAAAACYAAAAAAAAAwOD//wAAAAAmAAAAZAAAABYAAABMAAAAAAAAAAAAAAAEAAAAAAAAAAEAAABZWVkKAAAAACgAAAAoAAAAZAAAAGQAAAAAAAAAzMzMAAAAAABQAAAAUAAAAGQAAABkAAAAAAAAABcAAAAUAAAAAAAAAAAAAAD/fwAA/38AAAAAAAAJAAAABAAAAGdlODkeAAAAaAAAAAAAAAAAAAAAAAAAAAAAAAAAAAAAECcAABAnAAAAAAAAAAAAAAAAAAAAAAAAAAAAAAAAAAAAAAAAAAAAABQAAAAAAAAAwMD/AAAAAABkAAAAMgAAAAAAAABkAAAAAAAAAH9/fwAKAAAAIgAAABgAAAAAAAAAAAAAAAAAAAAAAAAAAAAAAAAAAAAkAAAAJAAAAAAAAAAHAAAAAAAAAAAAAAAAAAAAAAAAAAAAAAAAAAAAf39/ACUAAABYAAAAAAAAAAAAAAAAAAAAAAAAAAAAAAAAAAAAAAAAAAAAAAAAAAAAAAAAAAAAAAA/AAAAAAAAAKCGAQAAAAAAAAAAAAAAAAAMAAAAAQAAAAAAAAAAAAAAAAAAAB8AAABUAAAAAAAABQAAAAEAAAAAAAAAAAAAAAAAAAAAAAAAAAAAAAAAAAAAAAAAAAAAAAJ/f38AAAAAA8zMzADAwP8Af39/AAAAAAAAAAAAAAAAAAAAAAAAAAAAIQAAABgAAAAUAAAAFAMAALYCAAB/NwAAvwoAABAAAAAmAAAACAAAAL2/AAD/HwAA"/>
               </a:ext>
             </a:extLst>
           </p:cNvSpPr>
@@ -7802,7 +7802,7 @@
             <a:spLocks noGrp="1" noChangeArrowheads="1"/>
             <a:extLst>
               <a:ext uri="smNativeData">
-                <pr:smNativeData xmlns:pr="smNativeData" xmlns="smNativeData" val="SMDATA_15_LkR5ZhMAAAAlAAAAZAAAAA0AAAAAkAAAAJAAAACQAAAAkAAAAAAAAAAAAAAAAAAAAAEAAABQAAAAAAAAAAAA4D8AAAAAAADgPwAAAAAAAOA/AAAAAAAA4D8AAAAAAADgPwAAAAAAAOA/AAAAAAAA4D8AAAAAAADgPwAAAAAAAOA/AAAAAAAA4D8CAAAAjAAAAAAAAAAAAAAAQoX0DP///wgAAAAAAAAAAAAAAAAAAAAAAAAAAAAAAAAAAAAAZAAAAAEAAABAAAAAAAAAAAAAAAAAAAAAAAAAAAAAAAAAAAAAAAAAAAAAAAAAAAAAAAAAAAAAAAAAAAAAAAAAAAAAAAAAAAAAAAAAAAAAAAAAAAAAAAAAAAAAAAAAAAAAFAAAADwAAAAAAAAAAAAAAAAAAAkUAAAAAQAAABQAAAAUAAAAFAAAAAEAAAAAAAAAZAAAAGQAAAAAAAAAZAAAAGQAAAAVAAAAYAAAAAAAAAAAAAAADwAAACADAAAAAAAAAAAAAAEAAACgMgAAVgcAAKr4//8BAAAAf39/AAEAAABkAAAAAAAAABQAAABAHwAAAAAAACYAAAAAAAAAwOD//wAAAAAmAAAAZAAAABYAAABMAAAAAAAAAAAAAAAEAAAAAAAAAAEAAABZWVkKAAAAACgAAAAoAAAAZAAAAGQAAAAAAAAAzMzMAAAAAABQAAAAUAAAAGQAAABkAAAAAAAAABcAAAAUAAAAAAAAAAAAAAD/fwAA/38AAAAAAAAJAAAABAAAAGdlODkeAAAAaAAAAAAAAAAAAAAAAAAAAAAAAAAAAAAAECcAABAnAAAAAAAAAAAAAAAAAAAAAAAAAAAAAAAAAAAAAAAAAAAAABQAAAAAAAAAwMD/AAAAAABkAAAAMgAAAAAAAABkAAAAAAAAAH9/fwAKAAAAIgAAABgAAAAAAAAAAAAAAAAAAAAAAAAAAAAAAAAAAAAkAAAAJAAAAAAAAAAHAAAAAAAAAAAAAAAAAAAAAAAAAAAAAAAAAAAAf39/ACUAAABYAAAAAAAAAAAAAAAAAAAAAAAAAAAAAAAAAAAAAAAAAAAAAAAAAAAAAAAAAAAAAAA/AAAAAAAAAKCGAQAAAAAAAAAAAAAAAAAMAAAAAQAAAAAAAAAAAAAAAAAAAB8AAABUAAAAAAAABQAAAAEAAAAAAAAAAAAAAAAAAAAAAAAAAAAAAAAAAAAAAAAAAAAAAAJ/f38AAAAAA8zMzADAwP8Af39/AAAAAAAAAAAAAAAAAAAAAAAAAAAAIQAAABgAAAAUAAAAnAIAALMLAAAHNwAAuScAABAAAAAmAAAACAAAAL2/AAD/HwAA"/>
+                <pr:smNativeData xmlns:pr="smNativeData" xmlns="smNativeData" val="SMDATA_15_FUV5ZhMAAAAlAAAAZAAAAA0AAAAAkAAAAJAAAACQAAAAkAAAAAAAAAAAAAAAAAAAAAEAAABQAAAAAAAAAAAA4D8AAAAAAADgPwAAAAAAAOA/AAAAAAAA4D8AAAAAAADgPwAAAAAAAOA/AAAAAAAA4D8AAAAAAADgPwAAAAAAAOA/AAAAAAAA4D8CAAAAjAAAAAAAAAAAAAAAQoX0DP///wgAAAAAAAAAAAAAAAAAAAAAAAAAAAAAAAAAAAAAZAAAAAEAAABAAAAAAAAAAAAAAAAAAAAAAAAAAAAAAAAAAAAAAAAAAAAAAAAAAAAAAAAAAAAAAAAAAAAAAAAAAAAAAAAAAAAAAAAAAAAAAAAAAAAAAAAAAAAAAAAAAAAAFAAAADwAAAAAAAAAAAAAAAAAAAkUAAAAAQAAABQAAAAUAAAAFAAAAAEAAAAAAAAAZAAAAGQAAAAAAAAAZAAAAGQAAAAVAAAAYAAAAAAAAAAAAAAADwAAACADAAAAAAAAAAAAAAEAAACgMgAAVgcAAKr4//8BAAAAf39/AAEAAABkAAAAAAAAABQAAABAHwAAAAAAACYAAAAAAAAAwOD//wAAAAAmAAAAZAAAABYAAABMAAAAAAAAAAAAAAAEAAAAAAAAAAEAAABZWVkKAAAAACgAAAAoAAAAZAAAAGQAAAAAAAAAzMzMAAAAAABQAAAAUAAAAGQAAABkAAAAAAAAABcAAAAUAAAAAAAAAAAAAAD/fwAA/38AAAAAAAAJAAAABAAAAGdlODkeAAAAaAAAAAAAAAAAAAAAAAAAAAAAAAAAAAAAECcAABAnAAAAAAAAAAAAAAAAAAAAAAAAAAAAAAAAAAAAAAAAAAAAABQAAAAAAAAAwMD/AAAAAABkAAAAMgAAAAAAAABkAAAAAAAAAH9/fwAKAAAAIgAAABgAAAAAAAAAAAAAAAAAAAAAAAAAAAAAAAAAAAAkAAAAJAAAAAAAAAAHAAAAAAAAAAAAAAAAAAAAAAAAAAAAAAAAAAAAf39/ACUAAABYAAAAAAAAAAAAAAAAAAAAAAAAAAAAAAAAAAAAAAAAAAAAAAAAAAAAAAAAAAAAAAA/AAAAAAAAAKCGAQAAAAAAAAAAAAAAAAAMAAAAAQAAAAAAAAAAAAAAAAAAAB8AAABUAAAAAAAABQAAAAEAAAAAAAAAAAAAAAAAAAAAAAAAAAAAAAAAAAAAAAAAAAAAAAJ/f38AAAAAA8zMzADAwP8Af39/AAAAAAAAAAAAAAAAAAAAAAAAAAAAIQAAABgAAAAUAAAAnAIAALMLAAAHNwAAuScAABAAAAAmAAAACAAAAL2/AAD/HwAA"/>
               </a:ext>
             </a:extLst>
           </p:cNvSpPr>
@@ -8068,7 +8068,7 @@
             <a:spLocks noGrp="1" noChangeArrowheads="1"/>
             <a:extLst>
               <a:ext uri="smNativeData">
-                <pr:smNativeData xmlns:pr="smNativeData" xmlns="smNativeData" val="SMDATA_15_LkR5ZhMAAAAlAAAAZAAAAA0AAAAAkAAAAJAAAACQAAAAkAAAAAAAAAABAAAAAAAAAAEAAABQAAAAAAAAAAAA4D8AAAAAAADgPwAAAAAAAOA/AAAAAAAA4D8AAAAAAADgPwAAAAAAAOA/AAAAAAAA4D8AAAAAAADgPwAAAAAAAOA/AAAAAAAA4D8CAAAAjAAAAAAAAAAAAAAAQoX0DP///wgAAAAAAAAAAAAAAAAAAAAAAAAAAAAAAAAAAAAAZAAAAAEAAABAAAAAAAAAAAAAAAAAAAAAAAAAAAAAAAAAAAAAAAAAAAAAAAAAAAAAAAAAAAAAAAAAAAAAAAAAAAAAAAAAAAAAAAAAAAAAAAAAAAAAAAAAAAAAAAAAAAAAFAAAADwAAAAAAAAAAAAAAAAAAAkUAAAAAQAAABQAAAAUAAAAFAAAAAEAAAAAAAAAZAAAAGQAAAAAAAAAZAAAAGQAAAAVAAAAYAAAAAAAAAAAAAAADwAAACADAAAAAAAAAAAAAAEAAACgMgAAVgcAAKr4//8BAAAAf39/AAEAAABkAAAAAAAAABQAAABAHwAAAAAAACYAAAAAAAAAwOD//wAAAAAmAAAAZAAAABYAAABMAAAAAAAAAAAAAAAEAAAAAAAAAAEAAABZWVkKAAAAACgAAAAoAAAAZAAAAGQAAAAAAAAAzMzMAAAAAABQAAAAUAAAAGQAAABkAAAAAAAAABcAAAAUAAAAAAAAAAAAAAD/fwAA/38AAAAAAAAJAAAABAAAAG0AOwAeAAAAaAAAAAAAAAAAAAAAAAAAAAAAAAAAAAAAECcAABAnAAAAAAAAAAAAAAAAAAAAAAAAAAAAAAAAAAAAAAAAAAAAABQAAAAAAAAAwMD/AAAAAABkAAAAMgAAAAAAAABkAAAAAAAAAH9/fwAKAAAAIgAAABgAAAAAAAAAAAAAAAAAAAAAAAAAAAAAAAAAAAAkAAAAJAAAAAAAAAAHAAAAAAAAAAAAAAAAAAAAAAAAAAAAAAAAAAAAf39/ACUAAABYAAAAAAAAAAAAAAAAAAAAAAAAAAAAAAAAAAAAAAAAAAAAAAAAAAAAAAAAAAAAAAA/AAAAAAAAAKCGAQAAAAAAAAAAAAAAAAAMAAAAAQAAAAAAAAAAAAAAAAAAAB8AAABUAAAAAAAABQAAAAEAAAAAAAAAAAAAAAAAAAAAAAAAAAAAAAAAAAAAAAAAAAAAAAJ/f38AAAAAA8zMzADAwP8Af39/AAAAAAAAAAAAAAAAAAAAAAAAAAAAIQAAABgAAAAUAAAAHjQAAEAmAAB/NwAAeikAABAAAAAmAAAACAAAAL2/AAD/HwAA"/>
+                <pr:smNativeData xmlns:pr="smNativeData" xmlns="smNativeData" val="SMDATA_15_FUV5ZhMAAAAlAAAAZAAAAA0AAAAAkAAAAJAAAACQAAAAkAAAAAAAAAABAAAAAAAAAAEAAABQAAAAAAAAAAAA4D8AAAAAAADgPwAAAAAAAOA/AAAAAAAA4D8AAAAAAADgPwAAAAAAAOA/AAAAAAAA4D8AAAAAAADgPwAAAAAAAOA/AAAAAAAA4D8CAAAAjAAAAAAAAAAAAAAAQoX0DP///wgAAAAAAAAAAAAAAAAAAAAAAAAAAAAAAAAAAAAAZAAAAAEAAABAAAAAAAAAAAAAAAAAAAAAAAAAAAAAAAAAAAAAAAAAAAAAAAAAAAAAAAAAAAAAAAAAAAAAAAAAAAAAAAAAAAAAAAAAAAAAAAAAAAAAAAAAAAAAAAAAAAAAFAAAADwAAAAAAAAAAAAAAAAAAAkUAAAAAQAAABQAAAAUAAAAFAAAAAEAAAAAAAAAZAAAAGQAAAAAAAAAZAAAAGQAAAAVAAAAYAAAAAAAAAAAAAAADwAAACADAAAAAAAAAAAAAAEAAACgMgAAVgcAAKr4//8BAAAAf39/AAEAAABkAAAAAAAAABQAAABAHwAAAAAAACYAAAAAAAAAwOD//wAAAAAmAAAAZAAAABYAAABMAAAAAAAAAAAAAAAEAAAAAAAAAAEAAABZWVkKAAAAACgAAAAoAAAAZAAAAGQAAAAAAAAAzMzMAAAAAABQAAAAUAAAAGQAAABkAAAAAAAAABcAAAAUAAAAAAAAAAAAAAD/fwAA/38AAAAAAAAJAAAABAAAAG0AOwAeAAAAaAAAAAAAAAAAAAAAAAAAAAAAAAAAAAAAECcAABAnAAAAAAAAAAAAAAAAAAAAAAAAAAAAAAAAAAAAAAAAAAAAABQAAAAAAAAAwMD/AAAAAABkAAAAMgAAAAAAAABkAAAAAAAAAH9/fwAKAAAAIgAAABgAAAAAAAAAAAAAAAAAAAAAAAAAAAAAAAAAAAAkAAAAJAAAAAAAAAAHAAAAAAAAAAAAAAAAAAAAAAAAAAAAAAAAAAAAf39/ACUAAABYAAAAAAAAAAAAAAAAAAAAAAAAAAAAAAAAAAAAAAAAAAAAAAAAAAAAAAAAAAAAAAA/AAAAAAAAAKCGAQAAAAAAAAAAAAAAAAAMAAAAAQAAAAAAAAAAAAAAAAAAAB8AAABUAAAAAAAABQAAAAEAAAAAAAAAAAAAAAAAAAAAAAAAAAAAAAAAAAAAAAAAAAAAAAJ/f38AAAAAA8zMzADAwP8Af39/AAAAAAAAAAAAAAAAAAAAAAAAAAAAIQAAABgAAAAUAAAAHjQAAEAmAAB/NwAAeikAABAAAAAmAAAACAAAAL2/AAD/HwAA"/>
               </a:ext>
             </a:extLst>
           </p:cNvSpPr>
@@ -8179,7 +8179,7 @@
               </a:spcAft>
               <a:buNone/>
             </a:pPr>
-            <a:fld id="{3FDAA907-49D2-8F5F-9C62-BF0AE72C6AEA}" type="slidenum">
+            <a:fld id="{3FD90151-1FD2-8CF7-9C61-E9A24F2F6ABC}" type="slidenum">
               <a:rPr lang="ru-ru" cap="none"/>
               <a:t/>
             </a:fld>
@@ -8836,7 +8836,7 @@
             <a:spLocks noGrp="1" noChangeArrowheads="1"/>
             <a:extLst>
               <a:ext uri="smNativeData">
-                <pr:smNativeData xmlns:pr="smNativeData" xmlns="smNativeData" val="SMDATA_15_LkR5ZhMAAAAlAAAAZAAAAA0AAAAAkAAAAJAAAACQAAAAkAAAAAAAAAAAAAAAAAAAAAEAAABQAAAAAAAAAAAA4D8AAAAAAADgPwAAAAAAAOA/AAAAAAAA4D8AAAAAAADgPwAAAAAAAOA/AAAAAAAA4D8AAAAAAADgPwAAAAAAAOA/AAAAAAAA4D8CAAAAjAAAAAAAAAAAAAAAQoX0DP///wgAAAAAAAAAAAAAAAAAAAAAAAAAAAAAAAAAAAAAZAAAAAEAAABAAAAAAAAAAAAAAAAAAAAAAAAAAAAAAAAAAAAAAAAAAAAAAAAAAAAAAAAAAAAAAAAAAAAAAAAAAAAAAAAAAAAAAAAAAAAAAAAAAAAAAAAAAAAAAAAAAAAAFAAAADwAAAAAAAAAAAAAAAAAAAkUAAAAAQAAABQAAAAUAAAAFAAAAAEAAAAAAAAAZAAAAGQAAAAAAAAAZAAAAGQAAAAVAAAAYAAAAAAAAAAAAAAADwAAACADAAAAAAAAAAAAAAEAAACgMgAAVgcAAKr4//8BAAAAf39/AAEAAABkAAAAAAAAABQAAABAHwAAAAAAACYAAAAAAAAAwOD//wAAAAAmAAAAZAAAABYAAABMAAAAAAAAAAAAAAAEAAAAAAAAAAEAAABZWVkKAAAAACgAAAAoAAAAZAAAAGQAAAAAAAAAzMzMAAAAAABQAAAAUAAAAGQAAABkAAAAAAAAABcAAAAUAAAAAAAAAAAAAAD/fwAA/38AAAAAAAAJAAAABAAAAAAAAAAeAAAAaAAAAAAAAAAAAAAAAAAAAAAAAAAAAAAAECcAABAnAAAAAAAAAAAAAAAAAAAAAAAAAAAAAAAAAAAAAAAAAAAAABQAAAAAAAAAwMD/AAAAAABkAAAAMgAAAAAAAABkAAAAAAAAAH9/fwAKAAAAIgAAABgAAAAAAAAAAAAAAAAAAAAAAAAAAAAAAAAAAAAkAAAAJAAAAAAAAAAHAAAAAAAAAAAAAAAAAAAAAAAAAAAAAAAAAAAAf39/ACUAAABYAAAAAAAAAAAAAAAAAAAAAAAAAAAAAAAAAAAAAAAAAAAAAAAAAAAAAAAAAAAAAAA/AAAAAAAAAKCGAQAAAAAAAAAAAAAAAAAMAAAAAQAAAAAAAAAAAAAAAAAAAB8AAABUAAAAQoX0Bf///wEAAAAAAAAAAAAAAAAAAAAAAAAAAAAAAAAAAAAAAAAAAAAAAAJ/f38AWVlZA8zMzADAwP8Af39/AAAAAAAAAAAAAAAAAAAAAAAAAAAAIQAAABgAAAAUAAAA5wQAAD8jAAD6IwAAvykAABAAAAAmAAAACAAAADwwAAAAAAAA"/>
+                <pr:smNativeData xmlns:pr="smNativeData" xmlns="smNativeData" val="SMDATA_15_FUV5ZhMAAAAlAAAAZAAAAA0AAAAAkAAAAJAAAACQAAAAkAAAAAAAAAAAAAAAAAAAAAEAAABQAAAAAAAAAAAA4D8AAAAAAADgPwAAAAAAAOA/AAAAAAAA4D8AAAAAAADgPwAAAAAAAOA/AAAAAAAA4D8AAAAAAADgPwAAAAAAAOA/AAAAAAAA4D8CAAAAjAAAAAAAAAAAAAAAQoX0DP///wgAAAAAAAAAAAAAAAAAAAAAAAAAAAAAAAAAAAAAZAAAAAEAAABAAAAAAAAAAAAAAAAAAAAAAAAAAAAAAAAAAAAAAAAAAAAAAAAAAAAAAAAAAAAAAAAAAAAAAAAAAAAAAAAAAAAAAAAAAAAAAAAAAAAAAAAAAAAAAAAAAAAAFAAAADwAAAAAAAAAAAAAAAAAAAkUAAAAAQAAABQAAAAUAAAAFAAAAAEAAAAAAAAAZAAAAGQAAAAAAAAAZAAAAGQAAAAVAAAAYAAAAAAAAAAAAAAADwAAACADAAAAAAAAAAAAAAEAAACgMgAAVgcAAKr4//8BAAAAf39/AAEAAABkAAAAAAAAABQAAABAHwAAAAAAACYAAAAAAAAAwOD//wAAAAAmAAAAZAAAABYAAABMAAAAAAAAAAAAAAAEAAAAAAAAAAEAAABZWVkKAAAAACgAAAAoAAAAZAAAAGQAAAAAAAAAzMzMAAAAAABQAAAAUAAAAGQAAABkAAAAAAAAABcAAAAUAAAAAAAAAAAAAAD/fwAA/38AAAAAAAAJAAAABAAAAAAAAAAeAAAAaAAAAAAAAAAAAAAAAAAAAAAAAAAAAAAAECcAABAnAAAAAAAAAAAAAAAAAAAAAAAAAAAAAAAAAAAAAAAAAAAAABQAAAAAAAAAwMD/AAAAAABkAAAAMgAAAAAAAABkAAAAAAAAAH9/fwAKAAAAIgAAABgAAAAAAAAAAAAAAAAAAAAAAAAAAAAAAAAAAAAkAAAAJAAAAAAAAAAHAAAAAAAAAAAAAAAAAAAAAAAAAAAAAAAAAAAAf39/ACUAAABYAAAAAAAAAAAAAAAAAAAAAAAAAAAAAAAAAAAAAAAAAAAAAAAAAAAAAAAAAAAAAAA/AAAAAAAAAKCGAQAAAAAAAAAAAAAAAAAMAAAAAQAAAAAAAAAAAAAAAAAAAB8AAABUAAAAQoX0Bf///wEAAAAAAAAAAAAAAAAAAAAAAAAAAAAAAAAAAAAAAAAAAAAAAAJ/f38AWVlZA8zMzADAwP8Af39/AAAAAAAAAAAAAAAAAAAAAAAAAAAAIQAAABgAAAAUAAAA5wQAAD8jAAD6IwAAvykAABAAAAAmAAAACAAAADwwAAAAAAAA"/>
               </a:ext>
             </a:extLst>
           </p:cNvSpPr>
@@ -8877,7 +8877,7 @@
             <a:spLocks noGrp="1" noChangeArrowheads="1"/>
             <a:extLst>
               <a:ext uri="smNativeData">
-                <pr:smNativeData xmlns:pr="smNativeData" xmlns="smNativeData" val="SMDATA_15_LkR5ZhMAAAAlAAAAZAAAAA0AAAAAkAAAAJAAAACQAAAAkAAAAAAAAAAAAAAAAAAAAAEAAABQAAAAAAAAAAAA4D8AAAAAAADgPwAAAAAAAOA/AAAAAAAA4D8AAAAAAADgPwAAAAAAAOA/AAAAAAAA4D8AAAAAAADgPwAAAAAAAOA/AAAAAAAA4D8CAAAAjAAAAAAAAAAAAAAAQoX0DP///wgAAAAAAAAAAAAAAAAAAAAAAAAAAAAAAAAAAAAAZAAAAAEAAABAAAAAAAAAAAAAAAAAAAAAAAAAAAAAAAAAAAAAAAAAAAAAAAAAAAAAAAAAAAAAAAAAAAAAAAAAAAAAAAAAAAAAAAAAAAAAAAAAAAAAAAAAAAAAAAAAAAAAFAAAADwAAAAAAAAAAAAAAAAAAAkUAAAAAQAAABQAAAAUAAAAFAAAAAEAAAAAAAAAZAAAAGQAAAAAAAAAZAAAAGQAAAAVAAAAYAAAAAAAAAAAAAAADwAAACADAAAAAAAAAAAAAAEAAACgMgAAVgcAAKr4//8BAAAAf39/AAEAAABkAAAAAAAAABQAAABAHwAAAAAAACYAAAAAAAAAwOD//wAAAAAmAAAAZAAAABYAAABMAAAAAAAAAAAAAAAEAAAAAAAAAAEAAABZWVkKAAAAACgAAAAoAAAAZAAAAGQAAAAAAAAAzMzMAAAAAABQAAAAUAAAAGQAAABkAAAAAAAAABcAAAAUAAAAAAAAAAAAAAD/fwAA/38AAAAAAAAJAAAABAAAAAAAAAAeAAAAaAAAAAAAAAAAAAAAAAAAAAAAAAAAAAAAECcAABAnAAAAAAAAAAAAAAAAAAAAAAAAAAAAAAAAAAAAAAAAAAAAABQAAAAAAAAAwMD/AAAAAABkAAAAMgAAAAAAAABkAAAAAAAAAH9/fwAKAAAAIgAAABgAAAAAAAAAAAAAAAAAAAAAAAAAAAAAAAAAAAAkAAAAJAAAAAAAAAAHAAAAAAAAAAAAAAAAAAAAAAAAAAAAAAAAAAAAf39/ACUAAABYAAAAAAAAAAAAAAAAAAAAAAAAAAAAAAAAAAAAAAAAAAAAAAAAAAAAAAAAAAAAAAA/AAAAAAAAAKCGAQAAAAAAAAAAAAAAAAAMAAAAAQAAAAAAAAAAAAAAAAAAAB8AAABUAAAAQoX0Bf///wEAAAAAAAAAAAAAAAAAAAAAAAAAAAAAAAAAAAAAAAAAAAAAAAJ/f38AWVlZA8zMzADAwP8Af39/AAAAAAAAAAAAAAAAAAAAAAAAAAAAIQAAABgAAAAUAAAA5wQAAMMPAACROAAAfyQAABAAAAAmAAAACAAAADwwAAAAAAAA"/>
+                <pr:smNativeData xmlns:pr="smNativeData" xmlns="smNativeData" val="SMDATA_15_FUV5ZhMAAAAlAAAAZAAAAA0AAAAAkAAAAJAAAACQAAAAkAAAAAAAAAAAAAAAAAAAAAEAAABQAAAAAAAAAAAA4D8AAAAAAADgPwAAAAAAAOA/AAAAAAAA4D8AAAAAAADgPwAAAAAAAOA/AAAAAAAA4D8AAAAAAADgPwAAAAAAAOA/AAAAAAAA4D8CAAAAjAAAAAAAAAAAAAAAQoX0DP///wgAAAAAAAAAAAAAAAAAAAAAAAAAAAAAAAAAAAAAZAAAAAEAAABAAAAAAAAAAAAAAAAAAAAAAAAAAAAAAAAAAAAAAAAAAAAAAAAAAAAAAAAAAAAAAAAAAAAAAAAAAAAAAAAAAAAAAAAAAAAAAAAAAAAAAAAAAAAAAAAAAAAAFAAAADwAAAAAAAAAAAAAAAAAAAkUAAAAAQAAABQAAAAUAAAAFAAAAAEAAAAAAAAAZAAAAGQAAAAAAAAAZAAAAGQAAAAVAAAAYAAAAAAAAAAAAAAADwAAACADAAAAAAAAAAAAAAEAAACgMgAAVgcAAKr4//8BAAAAf39/AAEAAABkAAAAAAAAABQAAABAHwAAAAAAACYAAAAAAAAAwOD//wAAAAAmAAAAZAAAABYAAABMAAAAAAAAAAAAAAAEAAAAAAAAAAEAAABZWVkKAAAAACgAAAAoAAAAZAAAAGQAAAAAAAAAzMzMAAAAAABQAAAAUAAAAGQAAABkAAAAAAAAABcAAAAUAAAAAAAAAAAAAAD/fwAA/38AAAAAAAAJAAAABAAAAAAAAAAeAAAAaAAAAAAAAAAAAAAAAAAAAAAAAAAAAAAAECcAABAnAAAAAAAAAAAAAAAAAAAAAAAAAAAAAAAAAAAAAAAAAAAAABQAAAAAAAAAwMD/AAAAAABkAAAAMgAAAAAAAABkAAAAAAAAAH9/fwAKAAAAIgAAABgAAAAAAAAAAAAAAAAAAAAAAAAAAAAAAAAAAAAkAAAAJAAAAAAAAAAHAAAAAAAAAAAAAAAAAAAAAAAAAAAAAAAAAAAAf39/ACUAAABYAAAAAAAAAAAAAAAAAAAAAAAAAAAAAAAAAAAAAAAAAAAAAAAAAAAAAAAAAAAAAAA/AAAAAAAAAKCGAQAAAAAAAAAAAAAAAAAMAAAAAQAAAAAAAAAAAAAAAAAAAB8AAABUAAAAQoX0Bf///wEAAAAAAAAAAAAAAAAAAAAAAAAAAAAAAAAAAAAAAAAAAAAAAAJ/f38AWVlZA8zMzADAwP8Af39/AAAAAAAAAAAAAAAAAAAAAAAAAAAAIQAAABgAAAAUAAAA5wQAAMMPAACROAAAfyQAABAAAAAmAAAACAAAADwwAAAAAAAA"/>
               </a:ext>
             </a:extLst>
           </p:cNvSpPr>
@@ -8966,7 +8966,7 @@
             <a:spLocks noGrp="1" noChangeArrowheads="1"/>
             <a:extLst>
               <a:ext uri="smNativeData">
-                <pr:smNativeData xmlns:pr="smNativeData" xmlns="smNativeData" val="SMDATA_15_LkR5ZhMAAAAlAAAAZAAAAA0AAAAAkAAAAJAAAACQAAAAkAAAAAAAAAAAAAAAAAAAAAEAAABQAAAAAAAAAAAA4D8AAAAAAADgPwAAAAAAAOA/AAAAAAAA4D8AAAAAAADgPwAAAAAAAOA/AAAAAAAA4D8AAAAAAADgPwAAAAAAAOA/AAAAAAAA4D8CAAAAjAAAAAAAAAAAAAAAQoX0DP///wgAAAAAAAAAAAAAAAAAAAAAAAAAAAAAAAAAAAAAZAAAAAEAAABAAAAAAAAAAAAAAAAAAAAAAAAAAAAAAAAAAAAAAAAAAAAAAAAAAAAAAAAAAAAAAAAAAAAAAAAAAAAAAAAAAAAAAAAAAAAAAAAAAAAAAAAAAAAAAAAAAAAAFAAAADwAAAAAAAAAAAAAAAAAAAkUAAAAAQAAABQAAAAUAAAAFAAAAAEAAAAAAAAAZAAAAGQAAAAAAAAAZAAAAGQAAAAVAAAAYAAAAAAAAAAAAAAADwAAACADAAAAAAAAAAAAAAEAAACgMgAAVgcAAKr4//8BAAAAf39/AAEAAABkAAAAAAAAABQAAABAHwAAAAAAACYAAAAAAAAAwOD//wAAAAAmAAAAZAAAABYAAABMAAAAAAAAAAAAAAAEAAAAAAAAAAEAAABZWVkKAAAAACgAAAAoAAAAZAAAAGQAAAAAAAAAzMzMAAAAAABQAAAAUAAAAGQAAABkAAAAAAAAABcAAAAUAAAAAAAAAAAAAAD/fwAA/38AAAAAAAAJAAAABAAAAAAAAAAeAAAAaAAAAAAAAAAAAAAAAAAAAAAAAAAAAAAAECcAABAnAAAAAAAAAAAAAAAAAAAAAAAAAAAAAAAAAAAAAAAAAAAAABQAAAAAAAAAwMD/AAAAAABkAAAAMgAAAAAAAABkAAAAAAAAAH9/fwAKAAAAIgAAABgAAAAAAAAAAAAAAAAAAAAAAAAAAAAAAAAAAAAkAAAAJAAAAAAAAAAHAAAAAAAAAAAAAAAAAAAAAAAAAAAAAAAAAAAAf39/ACUAAABYAAAAAAAAAAAAAAAAAAAAAAAAAAAAAAAAAAAAAAAAAAAAAAAAAAAAAAAAAAAAAAA/AAAAAAAAAKCGAQAAAAAAAAAAAAAAAAAMAAAAAQAAAAAAAAAAAAAAAAAAAB8AAABUAAAAQoX0Bf///wEAAAAAAAAAAAAAAAAAAAAAAAAAAAAAAAAAAAAAAAAAAAAAAAJ/f38AWVlZA8zMzADAwP8Af39/AAAAAAAAAAAAAAAAAAAAAAAAAAAAIQAAABgAAAAUAAAAFAMAALYCAAB/NwAAvwoAABAAAAAmAAAACAAAAAAAAAAAAAAA"/>
+                <pr:smNativeData xmlns:pr="smNativeData" xmlns="smNativeData" val="SMDATA_15_FUV5ZhMAAAAlAAAAZAAAAA0AAAAAkAAAAJAAAACQAAAAkAAAAAAAAAAAAAAAAAAAAAEAAABQAAAAAAAAAAAA4D8AAAAAAADgPwAAAAAAAOA/AAAAAAAA4D8AAAAAAADgPwAAAAAAAOA/AAAAAAAA4D8AAAAAAADgPwAAAAAAAOA/AAAAAAAA4D8CAAAAjAAAAAAAAAAAAAAAQoX0DP///wgAAAAAAAAAAAAAAAAAAAAAAAAAAAAAAAAAAAAAZAAAAAEAAABAAAAAAAAAAAAAAAAAAAAAAAAAAAAAAAAAAAAAAAAAAAAAAAAAAAAAAAAAAAAAAAAAAAAAAAAAAAAAAAAAAAAAAAAAAAAAAAAAAAAAAAAAAAAAAAAAAAAAFAAAADwAAAAAAAAAAAAAAAAAAAkUAAAAAQAAABQAAAAUAAAAFAAAAAEAAAAAAAAAZAAAAGQAAAAAAAAAZAAAAGQAAAAVAAAAYAAAAAAAAAAAAAAADwAAACADAAAAAAAAAAAAAAEAAACgMgAAVgcAAKr4//8BAAAAf39/AAEAAABkAAAAAAAAABQAAABAHwAAAAAAACYAAAAAAAAAwOD//wAAAAAmAAAAZAAAABYAAABMAAAAAAAAAAAAAAAEAAAAAAAAAAEAAABZWVkKAAAAACgAAAAoAAAAZAAAAGQAAAAAAAAAzMzMAAAAAABQAAAAUAAAAGQAAABkAAAAAAAAABcAAAAUAAAAAAAAAAAAAAD/fwAA/38AAAAAAAAJAAAABAAAAAAAAAAeAAAAaAAAAAAAAAAAAAAAAAAAAAAAAAAAAAAAECcAABAnAAAAAAAAAAAAAAAAAAAAAAAAAAAAAAAAAAAAAAAAAAAAABQAAAAAAAAAwMD/AAAAAABkAAAAMgAAAAAAAABkAAAAAAAAAH9/fwAKAAAAIgAAABgAAAAAAAAAAAAAAAAAAAAAAAAAAAAAAAAAAAAkAAAAJAAAAAAAAAAHAAAAAAAAAAAAAAAAAAAAAAAAAAAAAAAAAAAAf39/ACUAAABYAAAAAAAAAAAAAAAAAAAAAAAAAAAAAAAAAAAAAAAAAAAAAAAAAAAAAAAAAAAAAAA/AAAAAAAAAKCGAQAAAAAAAAAAAAAAAAAMAAAAAQAAAAAAAAAAAAAAAAAAAB8AAABUAAAAAAAABQAAAAEAAAAAAAAAAAAAAAAAAAAAAAAAAAAAAAAAAAAAAAAAAAAAAAJ/f38AWVlZA8zMzADAwP8Af39/AAAAAAAAAAAAAAAAAAAAAAAAAAAAIQAAABgAAAAUAAAAFAMAALYCAAB/NwAAvwoAABAAAAAmAAAACAAAAAAAAAAAAAAA"/>
               </a:ext>
             </a:extLst>
           </p:cNvSpPr>
@@ -8993,7 +8993,7 @@
             <a:spLocks noGrp="1" noChangeArrowheads="1"/>
             <a:extLst>
               <a:ext uri="smNativeData">
-                <pr:smNativeData xmlns:pr="smNativeData" xmlns="smNativeData" val="SMDATA_15_LkR5ZhMAAAAlAAAAZAAAAA0AAAAAkAAAAJAAAACQAAAAkAAAAAAAAAAAAAAAAAAAAAEAAABQAAAAAAAAAAAA4D8AAAAAAADgPwAAAAAAAOA/AAAAAAAA4D8AAAAAAADgPwAAAAAAAOA/AAAAAAAA4D8AAAAAAADgPwAAAAAAAOA/AAAAAAAA4D8CAAAAjAAAAAAAAAAAAAAAQoX0DP///wgAAAAAAAAAAAAAAAAAAAAAAAAAAAAAAAAAAAAAZAAAAAEAAABAAAAAAAAAAAAAAAAAAAAAAAAAAAAAAAAAAAAAAAAAAAAAAAAAAAAAAAAAAAAAAAAAAAAAAAAAAAAAAAAAAAAAAAAAAAAAAAAAAAAAAAAAAAAAAAAAAAAAFAAAADwAAAAAAAAAAAAAAAAAAAkUAAAAAQAAABQAAAAUAAAAFAAAAAEAAAAAAAAAZAAAAGQAAAAAAAAAZAAAAGQAAAAVAAAAYAAAAAAAAAAAAAAADwAAACADAAAAAAAAAAAAAAEAAACgMgAAVgcAAKr4//8BAAAAf39/AAEAAABkAAAAAAAAABQAAABAHwAAAAAAACYAAAAAAAAAwOD//wAAAAAmAAAAZAAAABYAAABMAAAAAAAAAAAAAAAEAAAAAAAAAAEAAABZWVkKAAAAACgAAAAoAAAAZAAAAGQAAAAAAAAAzMzMAAAAAABQAAAAUAAAAGQAAABkAAAAAAAAABcAAAAUAAAAAAAAAAAAAAD/fwAA/38AAAAAAAAJAAAABAAAAAAAAAAeAAAAaAAAAAAAAAAAAAAAAAAAAAAAAAAAAAAAECcAABAnAAAAAAAAAAAAAAAAAAAAAAAAAAAAAAAAAAAAAAAAAAAAABQAAAAAAAAAwMD/AAAAAABkAAAAMgAAAAAAAABkAAAAAAAAAH9/fwAKAAAAIgAAABgAAAAAAAAAAAAAAAAAAAAAAAAAAAAAAAAAAAAkAAAAJAAAAAAAAAAHAAAAAAAAAAAAAAAAAAAAAAAAAAAAAAAAAAAAf39/ACUAAABYAAAAAAAAAAAAAAAAAAAAAAAAAAAAAAAAAAAAAAAAAAAAAAAAAAAAAAAAAAAAAAA/AAAAAAAAAKCGAQAAAAAAAAAAAAAAAAAMAAAAAQAAAAAAAAAAAAAAAAAAAB8AAABUAAAAQoX0Bf///wEAAAAAAAAAAAAAAAAAAAAAAAAAAAAAAAAAAAAAAAAAAAAAAAJ/f38AWVlZA8zMzADAwP8Af39/AAAAAAAAAAAAAAAAAAAAAAAAAAAAIQAAABgAAAAUAAAAFAMAALMLAAB/NwAAuScAABAAAAAmAAAACAAAAAAAAAAAAAAA"/>
+                <pr:smNativeData xmlns:pr="smNativeData" xmlns="smNativeData" val="SMDATA_15_FUV5ZhMAAAAlAAAAZAAAAA0AAAAAkAAAAJAAAACQAAAAkAAAAAAAAAAAAAAAAAAAAAEAAABQAAAAAAAAAAAA4D8AAAAAAADgPwAAAAAAAOA/AAAAAAAA4D8AAAAAAADgPwAAAAAAAOA/AAAAAAAA4D8AAAAAAADgPwAAAAAAAOA/AAAAAAAA4D8CAAAAjAAAAAAAAAAAAAAAQoX0DP///wgAAAAAAAAAAAAAAAAAAAAAAAAAAAAAAAAAAAAAZAAAAAEAAABAAAAAAAAAAAAAAAAAAAAAAAAAAAAAAAAAAAAAAAAAAAAAAAAAAAAAAAAAAAAAAAAAAAAAAAAAAAAAAAAAAAAAAAAAAAAAAAAAAAAAAAAAAAAAAAAAAAAAFAAAADwAAAAAAAAAAAAAAAAAAAkUAAAAAQAAABQAAAAUAAAAFAAAAAEAAAAAAAAAZAAAAGQAAAAAAAAAZAAAAGQAAAAVAAAAYAAAAAAAAAAAAAAADwAAACADAAAAAAAAAAAAAAEAAACgMgAAVgcAAKr4//8BAAAAf39/AAEAAABkAAAAAAAAABQAAABAHwAAAAAAACYAAAAAAAAAwOD//wAAAAAmAAAAZAAAABYAAABMAAAAAAAAAAAAAAAEAAAAAAAAAAEAAABZWVkKAAAAACgAAAAoAAAAZAAAAGQAAAAAAAAAzMzMAAAAAABQAAAAUAAAAGQAAABkAAAAAAAAABcAAAAUAAAAAAAAAAAAAAD/fwAA/38AAAAAAAAJAAAABAAAAAAAAAAeAAAAaAAAAAAAAAAAAAAAAAAAAAAAAAAAAAAAECcAABAnAAAAAAAAAAAAAAAAAAAAAAAAAAAAAAAAAAAAAAAAAAAAABQAAAAAAAAAwMD/AAAAAABkAAAAMgAAAAAAAABkAAAAAAAAAH9/fwAKAAAAIgAAABgAAAAAAAAAAAAAAAAAAAAAAAAAAAAAAAAAAAAkAAAAJAAAAAAAAAAHAAAAAAAAAAAAAAAAAAAAAAAAAAAAAAAAAAAAf39/ACUAAABYAAAAAAAAAAAAAAAAAAAAAAAAAAAAAAAAAAAAAAAAAAAAAAAAAAAAAAAAAAAAAAA/AAAAAAAAAKCGAQAAAAAAAAAAAAAAAAAMAAAAAQAAAAAAAAAAAAAAAAAAAB8AAABUAAAAAAAABQAAAAEAAAAAAAAAAAAAAAAAAAAAAAAAAAAAAAAAAAAAAAAAAAAAAAJ/f38AWVlZA8zMzADAwP8Af39/AAAAAAAAAAAAAAAAAAAAAAAAAAAAIQAAABgAAAAUAAAAFAMAALMLAAB/NwAAuScAABAAAAAmAAAACAAAAAAAAAAAAAAA"/>
               </a:ext>
             </a:extLst>
           </p:cNvSpPr>
@@ -9026,7 +9026,7 @@
             <a:picLocks noChangeAspect="1"/>
             <a:extLst>
               <a:ext uri="smNativeData">
-                <pr:smNativeData xmlns:pr="smNativeData" xmlns="smNativeData" val="SMDATA_17_LkR5ZhMAAAAlAAAAEQAAAC8BAAAAkAAAAEgAAACQAAAASAAAAAAAAAAAAAAAAAAAAAEAAABQAAAAAAAAAAAA4D8AAAAAAADgPwAAAAAAAOA/AAAAAAAA4D8AAAAAAADgPwAAAAAAAOA/AAAAAAAA4D8AAAAAAADgPwAAAAAAAOA/AAAAAAAA4D8CAAAAjAAAAAAAAAAAAAAAQoX0DP///wgAAAAAAAAAAAAAAAAAAAAAAAAAAAAAAAAAAAAAZAAAAAEAAABAAAAAAAAAAAAAAAAAAAAAAAAAAAAAAAAAAAAAAAAAAAAAAAAAAAAAAAAAAAAAAAAAAAAAAAAAAAAAAAAAAAAAAAAAAAAAAAAAAAAAAAAAAAAAAAAAAAAAFAAAADwAAAAAAAAAAAAAAAAAAAkUAAAAAQAAABQAAAAUAAAAFAAAAAEAAAAAAAAAZAAAAGQAAAAAAAAAZAAAAGQAAAAVAAAAYAAAAAAAAAAAAAAADwAAACADAAAAAAAAAAAAAAEAAACgMgAAVgcAAKr4//8BAAAAf39/AAEAAABkAAAAAAAAABQAAABAHwAAAAAAACYAAAAAAAAAwOD//wAAAAAmAAAAZAAAABYAAABMAAAAAAAAAAAAAAAEAAAAAAAAAAEAAABZWVkKAAAAACgAAAAoAAAAZAAAAGQAAAAAAAAAzMzMAAAAAABQAAAAUAAAAGQAAABkAAAAAAAAAAcAAAA4AAAAAAAAAAAAAAAAAAAA////AAAAAAAAAAAAAAAAAAAAAAAAAAAAAAAAAAAAAABkAAAAZAAAAAAAAAAjAAAABAAAAGQAAAAXAAAAFAAAAAAAAAAAAAAA/38AAP9/AAAAAAAACQAAAAQAAAABAAAAHgAAAGgAAAAAAAAAAAAAAAAAAAAAAAAAAAAAABAnAAAQJwAAAAAAAAAAAAAAAAAAAAAAAAAAAAAAAAAAAAAAAAAAAAAUAAAAAAAAAMDA/wAAAAAAZAAAADIAAAAAAAAAZAAAAAAAAAB/f38ACgAAACIAAAAYAAAAAAAAAAAAAAAAAAAAAAAAAAAAAAAAAAAAJAAAACQAAAAAAAAABwAAAAAAAAAAAAAAAAAAAAAAAAAAAAAAAAAAAH9/fwAlAAAAWAAAAAAAAAAAAAAAAAAAAAAAAAAAAAAAAAAAAAAAAAAAAAAAAAAAAAAAAAAAAAAAPwAAAAAAAACghgEAAAAAAAAAAAAAAAAADAAAAAEAAAAAAAAAAAAAAAAAAAAfAAAAVAAAAEKF9AX///8BAAAAAAAAAAAAAAAAAAAAAAAAAAAAAAAAAAAAAAAAAAAAAAACf39/AFlZWQPMzMwAwMD/AH9/fwAAAAAAAAAAAAAAAAD///8AAAAAACEAAAAYAAAAFAAAAOwDAADNDgAA7yIAAA4nAAAQAAAAJgAAAAgAAAD//////////w=="/>
+                <pr:smNativeData xmlns:pr="smNativeData" xmlns="smNativeData" val="SMDATA_17_FUV5ZhMAAAAlAAAAEQAAAC8BAAAAkAAAAEgAAACQAAAASAAAAAAAAAAAAAAAAAAAAAEAAABQAAAAAAAAAAAA4D8AAAAAAADgPwAAAAAAAOA/AAAAAAAA4D8AAAAAAADgPwAAAAAAAOA/AAAAAAAA4D8AAAAAAADgPwAAAAAAAOA/AAAAAAAA4D8CAAAAjAAAAAAAAAAAAAAAQoX0DP///wgAAAAAAAAAAAAAAAAAAAAAAAAAAAAAAAAAAAAAZAAAAAEAAABAAAAAAAAAAAAAAAAAAAAAAAAAAAAAAAAAAAAAAAAAAAAAAAAAAAAAAAAAAAAAAAAAAAAAAAAAAAAAAAAAAAAAAAAAAAAAAAAAAAAAAAAAAAAAAAAAAAAAFAAAADwAAAAAAAAAAAAAAAAAAAkUAAAAAQAAABQAAAAUAAAAFAAAAAEAAAAAAAAAZAAAAGQAAAAAAAAAZAAAAGQAAAAVAAAAYAAAAAAAAAAAAAAADwAAACADAAAAAAAAAAAAAAEAAACgMgAAVgcAAKr4//8BAAAAf39/AAEAAABkAAAAAAAAABQAAABAHwAAAAAAACYAAAAAAAAAwOD//wAAAAAmAAAAZAAAABYAAABMAAAAAAAAAAAAAAAEAAAAAAAAAAEAAABZWVkKAAAAACgAAAAoAAAAZAAAAGQAAAAAAAAAzMzMAAAAAABQAAAAUAAAAGQAAABkAAAAAAAAAAcAAAA4AAAAAAAAAAAAAAAAAAAA////AAAAAAAAAAAAAAAAAAAAAAAAAAAAAAAAAAAAAABkAAAAZAAAAAAAAAAjAAAABAAAAGQAAAAXAAAAFAAAAAAAAAAAAAAA/38AAP9/AAAAAAAACQAAAAQAAAABAAAAHgAAAGgAAAAAAAAAAAAAAAAAAAAAAAAAAAAAABAnAAAQJwAAAAAAAAAAAAAAAAAAAAAAAAAAAAAAAAAAAAAAAAAAAAAUAAAAAAAAAMDA/wAAAAAAZAAAADIAAAAAAAAAZAAAAAAAAAB/f38ACgAAACIAAAAYAAAAAAAAAAAAAAAAAAAAAAAAAAAAAAAAAAAAJAAAACQAAAAAAAAABwAAAAAAAAAAAAAAAAAAAAAAAAAAAAAAAAAAAH9/fwAlAAAAWAAAAAAAAAAAAAAAAAAAAAAAAAAAAAAAAAAAAAAAAAAAAAAAAAAAAAAAAAAAAAAAPwAAAAAAAACghgEAAAAAAAAAAAAAAAAADAAAAAEAAAAAAAAAAAAAAAAAAAAfAAAAVAAAAEKF9AX///8BAAAAAAAAAAAAAAAAAAAAAAAAAAAAAAAAAAAAAAAAAAAAAAACf39/AFlZWQPMzMwAwMD/AH9/fwAAAAAAAAAAAAAAAAD///8AAAAAACEAAAAYAAAAFAAAAOwDAADNDgAA7yIAAA4nAAAQAAAAJgAAAAgAAAD//////////w=="/>
               </a:ext>
             </a:extLst>
           </p:cNvPicPr>
@@ -9092,7 +9092,7 @@
             <a:spLocks noGrp="1" noChangeArrowheads="1"/>
             <a:extLst>
               <a:ext uri="smNativeData">
-                <pr:smNativeData xmlns:pr="smNativeData" xmlns="smNativeData" val="SMDATA_15_LkR5ZhMAAAAlAAAAZAAAAA0AAAAAkAAAAJAAAACQAAAAkAAAAAAAAAAAAAAAAAAAAAEAAABQAAAAAAAAAAAA4D8AAAAAAADgPwAAAAAAAOA/AAAAAAAA4D8AAAAAAADgPwAAAAAAAOA/AAAAAAAA4D8AAAAAAADgPwAAAAAAAOA/AAAAAAAA4D8CAAAAjAAAAAAAAAAAAAAAQoX0DP///wgAAAAAAAAAAAAAAAAAAAAAAAAAAAAAAAAAAAAAZAAAAAEAAABAAAAAAAAAAAAAAAAAAAAAAAAAAAAAAAAAAAAAAAAAAAAAAAAAAAAAAAAAAAAAAAAAAAAAAAAAAAAAAAAAAAAAAAAAAAAAAAAAAAAAAAAAAAAAAAAAAAAAFAAAADwAAAAAAAAAAAAAAAAAAAkUAAAAAQAAABQAAAAUAAAAFAAAAAEAAAAAAAAAZAAAAGQAAAAAAAAAZAAAAGQAAAAVAAAAYAAAAAAAAAAAAAAADwAAACADAAAAAAAAAAAAAAEAAACgMgAAVgcAAKr4//8BAAAAf39/AAEAAABkAAAAAAAAABQAAABAHwAAAAAAACYAAAAAAAAAwOD//wAAAAAmAAAAZAAAABYAAABMAAAAAAAAAAAAAAAEAAAAAAAAAAEAAABZWVkKAAAAACgAAAAoAAAAZAAAAGQAAAAAAAAAzMzMAAAAAABQAAAAUAAAAGQAAABkAAAAAAAAABcAAAAUAAAAAAAAAAAAAAD/fwAA/38AAAAAAAAJAAAABAAAAAAAAAAeAAAAaAAAAAAAAAAAAAAAAAAAAAAAAAAAAAAAECcAABAnAAAAAAAAAAAAAAAAAAAAAAAAAAAAAAAAAAAAAAAAAAAAABQAAAAAAAAAwMD/AAAAAABkAAAAMgAAAAAAAABkAAAAAAAAAH9/fwAKAAAAIgAAABgAAAAAAAAAAAAAAAAAAAAAAAAAAAAAAAAAAAAkAAAAJAAAAAAAAAAHAAAAAAAAAAAAAAAAAAAAAAAAAAAAAAAAAAAAf39/ACUAAABYAAAAAAAAAAAAAAAAAAAAAAAAAAAAAAAAAAAAAAAAAAAAAAAAAAAAAAAAAAAAAAA/AAAAAAAAAKCGAQAAAAAAAAAAAAAAAAAMAAAAAQAAAAAAAAAAAAAAAAAAAB8AAABUAAAAQoX0Bf///wEAAAAAAAAAAAAAAAAAAAAAAAAAAAAAAAAAAAAAAAAAAAAAAAJ/f38AWVlZA8zMzADAwP8Af39/AAAAAAAAAAAAAAAAAAAAAAAAAAAAIQAAABgAAAAUAAAAFAMAALYCAAB/NwAAvwoAABAAAAAmAAAACAAAAAAAAAAAAAAA"/>
+                <pr:smNativeData xmlns:pr="smNativeData" xmlns="smNativeData" val="SMDATA_15_FUV5ZhMAAAAlAAAAZAAAAA0AAAAAkAAAAJAAAACQAAAAkAAAAAAAAAAAAAAAAAAAAAEAAABQAAAAAAAAAAAA4D8AAAAAAADgPwAAAAAAAOA/AAAAAAAA4D8AAAAAAADgPwAAAAAAAOA/AAAAAAAA4D8AAAAAAADgPwAAAAAAAOA/AAAAAAAA4D8CAAAAjAAAAAAAAAAAAAAAQoX0DP///wgAAAAAAAAAAAAAAAAAAAAAAAAAAAAAAAAAAAAAZAAAAAEAAABAAAAAAAAAAAAAAAAAAAAAAAAAAAAAAAAAAAAAAAAAAAAAAAAAAAAAAAAAAAAAAAAAAAAAAAAAAAAAAAAAAAAAAAAAAAAAAAAAAAAAAAAAAAAAAAAAAAAAFAAAADwAAAAAAAAAAAAAAAAAAAkUAAAAAQAAABQAAAAUAAAAFAAAAAEAAAAAAAAAZAAAAGQAAAAAAAAAZAAAAGQAAAAVAAAAYAAAAAAAAAAAAAAADwAAACADAAAAAAAAAAAAAAEAAACgMgAAVgcAAKr4//8BAAAAf39/AAEAAABkAAAAAAAAABQAAABAHwAAAAAAACYAAAAAAAAAwOD//wAAAAAmAAAAZAAAABYAAABMAAAAAAAAAAAAAAAEAAAAAAAAAAEAAABZWVkKAAAAACgAAAAoAAAAZAAAAGQAAAAAAAAAzMzMAAAAAABQAAAAUAAAAGQAAABkAAAAAAAAABcAAAAUAAAAAAAAAAAAAAD/fwAA/38AAAAAAAAJAAAABAAAAAAAAAAeAAAAaAAAAAAAAAAAAAAAAAAAAAAAAAAAAAAAECcAABAnAAAAAAAAAAAAAAAAAAAAAAAAAAAAAAAAAAAAAAAAAAAAABQAAAAAAAAAwMD/AAAAAABkAAAAMgAAAAAAAABkAAAAAAAAAH9/fwAKAAAAIgAAABgAAAAAAAAAAAAAAAAAAAAAAAAAAAAAAAAAAAAkAAAAJAAAAAAAAAAHAAAAAAAAAAAAAAAAAAAAAAAAAAAAAAAAAAAAf39/ACUAAABYAAAAAAAAAAAAAAAAAAAAAAAAAAAAAAAAAAAAAAAAAAAAAAAAAAAAAAAAAAAAAAA/AAAAAAAAAKCGAQAAAAAAAAAAAAAAAAAMAAAAAQAAAAAAAAAAAAAAAAAAAB8AAABUAAAAAAAABQAAAAEAAAAAAAAAAAAAAAAAAAAAAAAAAAAAAAAAAAAAAAAAAAAAAAJ/f38AWVlZA8zMzADAwP8Af39/AAAAAAAAAAAAAAAAAAAAAAAAAAAAIQAAABgAAAAUAAAAFAMAALYCAAB/NwAAvwoAABAAAAAmAAAACAAAAAAAAAAAAAAA"/>
               </a:ext>
             </a:extLst>
           </p:cNvSpPr>
@@ -9119,7 +9119,7 @@
             <a:spLocks noGrp="1" noChangeArrowheads="1"/>
             <a:extLst>
               <a:ext uri="smNativeData">
-                <pr:smNativeData xmlns:pr="smNativeData" xmlns="smNativeData" val="SMDATA_15_LkR5ZhMAAAAlAAAAZAAAAA0AAAAAkAAAAJAAAACQAAAAkAAAAAAAAAAAAAAAAAAAAAEAAABQAAAAAAAAAAAA4D8AAAAAAADgPwAAAAAAAOA/AAAAAAAA4D8AAAAAAADgPwAAAAAAAOA/AAAAAAAA4D8AAAAAAADgPwAAAAAAAOA/AAAAAAAA4D8CAAAAjAAAAAAAAAAAAAAAQoX0DP///wgAAAAAAAAAAAAAAAAAAAAAAAAAAAAAAAAAAAAAZAAAAAEAAABAAAAAAAAAAAAAAAAAAAAAAAAAAAAAAAAAAAAAAAAAAAAAAAAAAAAAAAAAAAAAAAAAAAAAAAAAAAAAAAAAAAAAAAAAAAAAAAAAAAAAAAAAAAAAAAAAAAAAFAAAADwAAAAAAAAAAAAAAAAAAAkUAAAAAQAAABQAAAAUAAAAFAAAAAEAAAAAAAAAZAAAAGQAAAAAAAAAZAAAAGQAAAAVAAAAYAAAAAAAAAAAAAAADwAAACADAAAAAAAAAAAAAAEAAACgMgAAVgcAAKr4//8BAAAAf39/AAEAAABkAAAAAAAAABQAAABAHwAAAAAAACYAAAAAAAAAwOD//wAAAAAmAAAAZAAAABYAAABMAAAAAAAAAAAAAAAEAAAAAAAAAAEAAABZWVkKAAAAACgAAAAoAAAAZAAAAGQAAAAAAAAAzMzMAAAAAABQAAAAUAAAAGQAAABkAAAAAAAAABcAAAAUAAAAAAAAAAAAAAD/fwAA/38AAAAAAAAJAAAABAAAAAAAAAAeAAAAaAAAAAAAAAAAAAAAAAAAAAAAAAAAAAAAECcAABAnAAAAAAAAAAAAAAAAAAAAAAAAAAAAAAAAAAAAAAAAAAAAABQAAAAAAAAAwMD/AAAAAABkAAAAMgAAAAAAAABkAAAAAAAAAH9/fwAKAAAAIgAAABgAAAAAAAAAAAAAAAAAAAAAAAAAAAAAAAAAAAAkAAAAJAAAAAAAAAAHAAAAAAAAAAAAAAAAAAAAAAAAAAAAAAAAAAAAf39/ACUAAABYAAAAAAAAAAAAAAAAAAAAAAAAAAAAAAAAAAAAAAAAAAAAAAAAAAAAAAAAAAAAAAA/AAAAAAAAAKCGAQAAAAAAAAAAAAAAAAAMAAAAAQAAAAAAAAAAAAAAAAAAAB8AAABUAAAAQoX0Bf///wEAAAAAAAAAAAAAAAAAAAAAAAAAAAAAAAAAAAAAAAAAAAAAAAJ/f38AWVlZA8zMzADAwP8Af39/AAAAAAAAAAAAAAAAAAAAAAAAAAAAIQAAABgAAAAUAAAAFAMAALMLAAB/NwAAuScAABAAAAAmAAAACAAAAAAAAAAAAAAA"/>
+                <pr:smNativeData xmlns:pr="smNativeData" xmlns="smNativeData" val="SMDATA_15_FUV5ZhMAAAAlAAAAZAAAAA0AAAAAkAAAAJAAAACQAAAAkAAAAAAAAAAAAAAAAAAAAAEAAABQAAAAAAAAAAAA4D8AAAAAAADgPwAAAAAAAOA/AAAAAAAA4D8AAAAAAADgPwAAAAAAAOA/AAAAAAAA4D8AAAAAAADgPwAAAAAAAOA/AAAAAAAA4D8CAAAAjAAAAAAAAAAAAAAAQoX0DP///wgAAAAAAAAAAAAAAAAAAAAAAAAAAAAAAAAAAAAAZAAAAAEAAABAAAAAAAAAAAAAAAAAAAAAAAAAAAAAAAAAAAAAAAAAAAAAAAAAAAAAAAAAAAAAAAAAAAAAAAAAAAAAAAAAAAAAAAAAAAAAAAAAAAAAAAAAAAAAAAAAAAAAFAAAADwAAAAAAAAAAAAAAAAAAAkUAAAAAQAAABQAAAAUAAAAFAAAAAEAAAAAAAAAZAAAAGQAAAAAAAAAZAAAAGQAAAAVAAAAYAAAAAAAAAAAAAAADwAAACADAAAAAAAAAAAAAAEAAACgMgAAVgcAAKr4//8BAAAAf39/AAEAAABkAAAAAAAAABQAAABAHwAAAAAAACYAAAAAAAAAwOD//wAAAAAmAAAAZAAAABYAAABMAAAAAAAAAAAAAAAEAAAAAAAAAAEAAABZWVkKAAAAACgAAAAoAAAAZAAAAGQAAAAAAAAAzMzMAAAAAABQAAAAUAAAAGQAAABkAAAAAAAAABcAAAAUAAAAAAAAAAAAAAD/fwAA/38AAAAAAAAJAAAABAAAAAAAAAAeAAAAaAAAAAAAAAAAAAAAAAAAAAAAAAAAAAAAECcAABAnAAAAAAAAAAAAAAAAAAAAAAAAAAAAAAAAAAAAAAAAAAAAABQAAAAAAAAAwMD/AAAAAABkAAAAMgAAAAAAAABkAAAAAAAAAH9/fwAKAAAAIgAAABgAAAAAAAAAAAAAAAAAAAAAAAAAAAAAAAAAAAAkAAAAJAAAAAAAAAAHAAAAAAAAAAAAAAAAAAAAAAAAAAAAAAAAAAAAf39/ACUAAABYAAAAAAAAAAAAAAAAAAAAAAAAAAAAAAAAAAAAAAAAAAAAAAAAAAAAAAAAAAAAAAA/AAAAAAAAAKCGAQAAAAAAAAAAAAAAAAAMAAAAAQAAAAAAAAAAAAAAAAAAAB8AAABUAAAAAAAABQAAAAEAAAAAAAAAAAAAAAAAAAAAAAAAAAAAAAAAAAAAAAAAAAAAAAJ/f38AWVlZA8zMzADAwP8Af39/AAAAAAAAAAAAAAAAAAAAAAAAAAAAIQAAABgAAAAUAAAAFAMAALMLAAB/NwAAuScAABAAAAAmAAAACAAAAAAAAAAAAAAA"/>
               </a:ext>
             </a:extLst>
           </p:cNvSpPr>
@@ -9152,7 +9152,7 @@
             <a:picLocks noChangeAspect="1"/>
             <a:extLst>
               <a:ext uri="smNativeData">
-                <pr:smNativeData xmlns:pr="smNativeData" xmlns="smNativeData" val="SMDATA_17_LkR5ZhMAAAAlAAAAEQAAAC8BAAAAkAAAAEgAAACQAAAASAAAAAAAAAAAAAAAAAAAAAEAAABQAAAAAAAAAAAA4D8AAAAAAADgPwAAAAAAAOA/AAAAAAAA4D8AAAAAAADgPwAAAAAAAOA/AAAAAAAA4D8AAAAAAADgPwAAAAAAAOA/AAAAAAAA4D8CAAAAjAAAAAAAAAAAAAAAQoX0DP///wgAAAAAAAAAAAAAAAAAAAAAAAAAAAAAAAAAAAAAZAAAAAEAAABAAAAAAAAAAAAAAAAAAAAAAAAAAAAAAAAAAAAAAAAAAAAAAAAAAAAAAAAAAAAAAAAAAAAAAAAAAAAAAAAAAAAAAAAAAAAAAAAAAAAAAAAAAAAAAAAAAAAAFAAAADwAAAAAAAAAAAAAAAAAAAkUAAAAAQAAABQAAAAUAAAAFAAAAAEAAAAAAAAAZAAAAGQAAAAAAAAAZAAAAGQAAAAVAAAAYAAAAAAAAAAAAAAADwAAACADAAAAAAAAAAAAAAEAAACgMgAAVgcAAKr4//8BAAAAf39/AAEAAABkAAAAAAAAABQAAABAHwAAAAAAACYAAAAAAAAAwOD//wAAAAAmAAAAZAAAABYAAABMAAAAAAAAAAAAAAAEAAAAAAAAAAEAAABZWVkKAAAAACgAAAAoAAAAZAAAAGQAAAAAAAAAzMzMAAAAAABQAAAAUAAAAGQAAABkAAAAAAAAAAcAAAA4AAAAAAAAAAAAAAAAAAAA////AAAAAAAAAAAAAAAAAAAAAAAAAAAAAAAAAAAAAABkAAAAZAAAAAAAAAAjAAAABAAAAGQAAAAXAAAAFAAAAAAAAAAAAAAA/38AAP9/AAAAAAAACQAAAAQAAAAAAAAAHgAAAGgAAAAAAAAAAAAAAAAAAAAAAAAAAAAAABAnAAAQJwAAAAAAAAAAAAAAAAAAAAAAAAAAAAAAAAAAAAAAAAAAAAAUAAAAAAAAAMDA/wAAAAAAZAAAADIAAAAAAAAAZAAAAAAAAAB/f38ACgAAACIAAAAYAAAAAAAAAAAAAAAAAAAAAAAAAAAAAAAAAAAAJAAAACQAAAAAAAAABwAAAAAAAAAAAAAAAAAAAAAAAAAAAAAAAAAAAH9/fwAlAAAAWAAAAAAAAAAAAAAAAAAAAAAAAAAAAAAAAAAAAAAAAAAAAAAAAAAAAAAAAAAAAAAAPwAAAAAAAACghgEAAAAAAAAAAAAAAAAADAAAAAEAAAAAAAAAAAAAAAAAAAAfAAAAVAAAAEKF9AX///8BAAAAAAAAAAAAAAAAAAAAAAAAAAAAAAAAAAAAAAAAAAAAAAACf39/AFlZWQPMzMwAwMD/AH9/fwAAAAAAAAAAAAAAAAD///8AAAAAACEAAAAYAAAAFAAAACEEAADlDgAAuS8AAKMkAAAQAAAAJgAAAAgAAAD//////////w=="/>
+                <pr:smNativeData xmlns:pr="smNativeData" xmlns="smNativeData" val="SMDATA_17_FUV5ZhMAAAAlAAAAEQAAAC8BAAAAkAAAAEgAAACQAAAASAAAAAAAAAAAAAAAAAAAAAEAAABQAAAAAAAAAAAA4D8AAAAAAADgPwAAAAAAAOA/AAAAAAAA4D8AAAAAAADgPwAAAAAAAOA/AAAAAAAA4D8AAAAAAADgPwAAAAAAAOA/AAAAAAAA4D8CAAAAjAAAAAAAAAAAAAAAQoX0DP///wgAAAAAAAAAAAAAAAAAAAAAAAAAAAAAAAAAAAAAZAAAAAEAAABAAAAAAAAAAAAAAAAAAAAAAAAAAAAAAAAAAAAAAAAAAAAAAAAAAAAAAAAAAAAAAAAAAAAAAAAAAAAAAAAAAAAAAAAAAAAAAAAAAAAAAAAAAAAAAAAAAAAAFAAAADwAAAAAAAAAAAAAAAAAAAkUAAAAAQAAABQAAAAUAAAAFAAAAAEAAAAAAAAAZAAAAGQAAAAAAAAAZAAAAGQAAAAVAAAAYAAAAAAAAAAAAAAADwAAACADAAAAAAAAAAAAAAEAAACgMgAAVgcAAKr4//8BAAAAf39/AAEAAABkAAAAAAAAABQAAABAHwAAAAAAACYAAAAAAAAAwOD//wAAAAAmAAAAZAAAABYAAABMAAAAAAAAAAAAAAAEAAAAAAAAAAEAAABZWVkKAAAAACgAAAAoAAAAZAAAAGQAAAAAAAAAzMzMAAAAAABQAAAAUAAAAGQAAABkAAAAAAAAAAcAAAA4AAAAAAAAAAAAAAAAAAAA////AAAAAAAAAAAAAAAAAAAAAAAAAAAAAAAAAAAAAABkAAAAZAAAAAAAAAAjAAAABAAAAGQAAAAXAAAAFAAAAAAAAAAAAAAA/38AAP9/AAAAAAAACQAAAAQAAAAAAAAAHgAAAGgAAAAAAAAAAAAAAAAAAAAAAAAAAAAAABAnAAAQJwAAAAAAAAAAAAAAAAAAAAAAAAAAAAAAAAAAAAAAAAAAAAAUAAAAAAAAAMDA/wAAAAAAZAAAADIAAAAAAAAAZAAAAAAAAAB/f38ACgAAACIAAAAYAAAAAAAAAAAAAAAAAAAAAAAAAAAAAAAAAAAAJAAAACQAAAAAAAAABwAAAAAAAAAAAAAAAAAAAAAAAAAAAAAAAAAAAH9/fwAlAAAAWAAAAAAAAAAAAAAAAAAAAAAAAAAAAAAAAAAAAAAAAAAAAAAAAAAAAAAAAAAAAAAAPwAAAAAAAACghgEAAAAAAAAAAAAAAAAADAAAAAEAAAAAAAAAAAAAAAAAAAAfAAAAVAAAAEKF9AX///8BAAAAAAAAAAAAAAAAAAAAAAAAAAAAAAAAAAAAAAAAAAAAAAACf39/AFlZWQPMzMwAwMD/AH9/fwAAAAAAAAAAAAAAAAD///8AAAAAACEAAAAYAAAAFAAAACEEAADlDgAAuS8AAKMkAAAQAAAAJgAAAAgAAAD//////////w=="/>
               </a:ext>
             </a:extLst>
           </p:cNvPicPr>
@@ -9218,7 +9218,7 @@
             <a:spLocks noGrp="1" noChangeArrowheads="1"/>
             <a:extLst>
               <a:ext uri="smNativeData">
-                <pr:smNativeData xmlns:pr="smNativeData" xmlns="smNativeData" val="SMDATA_15_LkR5ZhMAAAAlAAAAZAAAAA0AAAAAkAAAAJAAAACQAAAAkAAAAAAAAAAAAAAAAAAAAAEAAABQAAAAAAAAAAAA4D8AAAAAAADgPwAAAAAAAOA/AAAAAAAA4D8AAAAAAADgPwAAAAAAAOA/AAAAAAAA4D8AAAAAAADgPwAAAAAAAOA/AAAAAAAA4D8CAAAAjAAAAAAAAAAAAAAAQoX0DP///wgAAAAAAAAAAAAAAAAAAAAAAAAAAAAAAAAAAAAAZAAAAAEAAABAAAAAAAAAAAAAAAAAAAAAAAAAAAAAAAAAAAAAAAAAAAAAAAAAAAAAAAAAAAAAAAAAAAAAAAAAAAAAAAAAAAAAAAAAAAAAAAAAAAAAAAAAAAAAAAAAAAAAFAAAADwAAAAAAAAAAAAAAAAAAAkUAAAAAQAAABQAAAAUAAAAFAAAAAEAAAAAAAAAZAAAAGQAAAAAAAAAZAAAAGQAAAAVAAAAYAAAAAAAAAAAAAAADwAAACADAAAAAAAAAAAAAAEAAACgMgAAVgcAAKr4//8BAAAAf39/AAEAAABkAAAAAAAAABQAAABAHwAAAAAAACYAAAAAAAAAwOD//wAAAAAmAAAAZAAAABYAAABMAAAAAAAAAAAAAAAEAAAAAAAAAAEAAABZWVkKAAAAACgAAAAoAAAAZAAAAGQAAAAAAAAAzMzMAAAAAABQAAAAUAAAAGQAAABkAAAAAAAAABcAAAAUAAAAAAAAAAAAAAD/fwAA/38AAAAAAAAJAAAABAAAAAAAAAAeAAAAaAAAAAAAAAAAAAAAAAAAAAAAAAAAAAAAECcAABAnAAAAAAAAAAAAAAAAAAAAAAAAAAAAAAAAAAAAAAAAAAAAABQAAAAAAAAAwMD/AAAAAABkAAAAMgAAAAAAAABkAAAAAAAAAH9/fwAKAAAAIgAAABgAAAAAAAAAAAAAAAAAAAAAAAAAAAAAAAAAAAAkAAAAJAAAAAAAAAAHAAAAAAAAAAAAAAAAAAAAAAAAAAAAAAAAAAAAf39/ACUAAABYAAAAAAAAAAAAAAAAAAAAAAAAAAAAAAAAAAAAAAAAAAAAAAAAAAAAAAAAAAAAAAA/AAAAAAAAAKCGAQAAAAAAAAAAAAAAAAAMAAAAAQAAAAAAAAAAAAAAAAAAAB8AAABUAAAAQoX0Bf///wEAAAAAAAAAAAAAAAAAAAAAAAAAAAAAAAAAAAAAAAAAAAAAAAJ/f38AWVlZA8zMzADAwP8Af39/AAAAAAAAAAAAAAAAAAAAAAAAAAAAIQAAABgAAAAUAAAAFAMAALYCAAB/NwAAvwoAABAAAAAmAAAACAAAAAAAAAAAAAAA"/>
+                <pr:smNativeData xmlns:pr="smNativeData" xmlns="smNativeData" val="SMDATA_15_FUV5ZhMAAAAlAAAAZAAAAA0AAAAAkAAAAJAAAACQAAAAkAAAAAAAAAAAAAAAAAAAAAEAAABQAAAAAAAAAAAA4D8AAAAAAADgPwAAAAAAAOA/AAAAAAAA4D8AAAAAAADgPwAAAAAAAOA/AAAAAAAA4D8AAAAAAADgPwAAAAAAAOA/AAAAAAAA4D8CAAAAjAAAAAAAAAAAAAAAQoX0DP///wgAAAAAAAAAAAAAAAAAAAAAAAAAAAAAAAAAAAAAZAAAAAEAAABAAAAAAAAAAAAAAAAAAAAAAAAAAAAAAAAAAAAAAAAAAAAAAAAAAAAAAAAAAAAAAAAAAAAAAAAAAAAAAAAAAAAAAAAAAAAAAAAAAAAAAAAAAAAAAAAAAAAAFAAAADwAAAAAAAAAAAAAAAAAAAkUAAAAAQAAABQAAAAUAAAAFAAAAAEAAAAAAAAAZAAAAGQAAAAAAAAAZAAAAGQAAAAVAAAAYAAAAAAAAAAAAAAADwAAACADAAAAAAAAAAAAAAEAAACgMgAAVgcAAKr4//8BAAAAf39/AAEAAABkAAAAAAAAABQAAABAHwAAAAAAACYAAAAAAAAAwOD//wAAAAAmAAAAZAAAABYAAABMAAAAAAAAAAAAAAAEAAAAAAAAAAEAAABZWVkKAAAAACgAAAAoAAAAZAAAAGQAAAAAAAAAzMzMAAAAAABQAAAAUAAAAGQAAABkAAAAAAAAABcAAAAUAAAAAAAAAAAAAAD/fwAA/38AAAAAAAAJAAAABAAAAAAAAAAeAAAAaAAAAAAAAAAAAAAAAAAAAAAAAAAAAAAAECcAABAnAAAAAAAAAAAAAAAAAAAAAAAAAAAAAAAAAAAAAAAAAAAAABQAAAAAAAAAwMD/AAAAAABkAAAAMgAAAAAAAABkAAAAAAAAAH9/fwAKAAAAIgAAABgAAAAAAAAAAAAAAAAAAAAAAAAAAAAAAAAAAAAkAAAAJAAAAAAAAAAHAAAAAAAAAAAAAAAAAAAAAAAAAAAAAAAAAAAAf39/ACUAAABYAAAAAAAAAAAAAAAAAAAAAAAAAAAAAAAAAAAAAAAAAAAAAAAAAAAAAAAAAAAAAAA/AAAAAAAAAKCGAQAAAAAAAAAAAAAAAAAMAAAAAQAAAAAAAAAAAAAAAAAAAB8AAABUAAAAAAAABQAAAAEAAAAAAAAAAAAAAAAAAAAAAAAAAAAAAAAAAAAAAAAAAAAAAAJ/f38AWVlZA8zMzADAwP8Af39/AAAAAAAAAAAAAAAAAAAAAAAAAAAAIQAAABgAAAAUAAAAFAMAALYCAAB/NwAAvwoAABAAAAAmAAAACAAAAAAAAAAAAAAA"/>
               </a:ext>
             </a:extLst>
           </p:cNvSpPr>
@@ -9245,7 +9245,7 @@
             <a:spLocks noGrp="1" noChangeArrowheads="1"/>
             <a:extLst>
               <a:ext uri="smNativeData">
-                <pr:smNativeData xmlns:pr="smNativeData" xmlns="smNativeData" val="SMDATA_15_LkR5ZhMAAAAlAAAAZAAAAA0AAAAAkAAAAJAAAACQAAAAkAAAAAAAAAAAAAAAAAAAAAEAAABQAAAAAAAAAAAA4D8AAAAAAADgPwAAAAAAAOA/AAAAAAAA4D8AAAAAAADgPwAAAAAAAOA/AAAAAAAA4D8AAAAAAADgPwAAAAAAAOA/AAAAAAAA4D8CAAAAjAAAAAAAAAAAAAAAQoX0DP///wgAAAAAAAAAAAAAAAAAAAAAAAAAAAAAAAAAAAAAZAAAAAEAAABAAAAAAAAAAAAAAAAAAAAAAAAAAAAAAAAAAAAAAAAAAAAAAAAAAAAAAAAAAAAAAAAAAAAAAAAAAAAAAAAAAAAAAAAAAAAAAAAAAAAAAAAAAAAAAAAAAAAAFAAAADwAAAAAAAAAAAAAAAAAAAkUAAAAAQAAABQAAAAUAAAAFAAAAAEAAAAAAAAAZAAAAGQAAAAAAAAAZAAAAGQAAAAVAAAAYAAAAAAAAAAAAAAADwAAACADAAAAAAAAAAAAAAEAAACgMgAAVgcAAKr4//8BAAAAf39/AAEAAABkAAAAAAAAABQAAABAHwAAAAAAACYAAAAAAAAAwOD//wAAAAAmAAAAZAAAABYAAABMAAAAAAAAAAAAAAAEAAAAAAAAAAEAAABZWVkKAAAAACgAAAAoAAAAZAAAAGQAAAAAAAAAzMzMAAAAAABQAAAAUAAAAGQAAABkAAAAAAAAABcAAAAUAAAAAAAAAAAAAAD/fwAA/38AAAAAAAAJAAAABAAAAAAAAAAeAAAAaAAAAAAAAAAAAAAAAAAAAAAAAAAAAAAAECcAABAnAAAAAAAAAAAAAAAAAAAAAAAAAAAAAAAAAAAAAAAAAAAAABQAAAAAAAAAwMD/AAAAAABkAAAAMgAAAAAAAABkAAAAAAAAAH9/fwAKAAAAIgAAABgAAAAAAAAAAAAAAAAAAAAAAAAAAAAAAAAAAAAkAAAAJAAAAAAAAAAHAAAAAAAAAAAAAAAAAAAAAAAAAAAAAAAAAAAAf39/ACUAAABYAAAAAAAAAAAAAAAAAAAAAAAAAAAAAAAAAAAAAAAAAAAAAAAAAAAAAAAAAAAAAAA/AAAAAAAAAKCGAQAAAAAAAAAAAAAAAAAMAAAAAQAAAAAAAAAAAAAAAAAAAB8AAABUAAAAQoX0Bf///wEAAAAAAAAAAAAAAAAAAAAAAAAAAAAAAAAAAAAAAAAAAAAAAAJ/f38AWVlZA8zMzADAwP8Af39/AAAAAAAAAAAAAAAAAAAAAAAAAAAAIQAAABgAAAAUAAAAFAMAALMLAAB/NwAAuScAABAAAAAmAAAACAAAAAAAAAAAAAAA"/>
+                <pr:smNativeData xmlns:pr="smNativeData" xmlns="smNativeData" val="SMDATA_15_FUV5ZhMAAAAlAAAAZAAAAA0AAAAAkAAAAJAAAACQAAAAkAAAAAAAAAAAAAAAAAAAAAEAAABQAAAAAAAAAAAA4D8AAAAAAADgPwAAAAAAAOA/AAAAAAAA4D8AAAAAAADgPwAAAAAAAOA/AAAAAAAA4D8AAAAAAADgPwAAAAAAAOA/AAAAAAAA4D8CAAAAjAAAAAAAAAAAAAAAQoX0DP///wgAAAAAAAAAAAAAAAAAAAAAAAAAAAAAAAAAAAAAZAAAAAEAAABAAAAAAAAAAAAAAAAAAAAAAAAAAAAAAAAAAAAAAAAAAAAAAAAAAAAAAAAAAAAAAAAAAAAAAAAAAAAAAAAAAAAAAAAAAAAAAAAAAAAAAAAAAAAAAAAAAAAAFAAAADwAAAAAAAAAAAAAAAAAAAkUAAAAAQAAABQAAAAUAAAAFAAAAAEAAAAAAAAAZAAAAGQAAAAAAAAAZAAAAGQAAAAVAAAAYAAAAAAAAAAAAAAADwAAACADAAAAAAAAAAAAAAEAAACgMgAAVgcAAKr4//8BAAAAf39/AAEAAABkAAAAAAAAABQAAABAHwAAAAAAACYAAAAAAAAAwOD//wAAAAAmAAAAZAAAABYAAABMAAAAAAAAAAAAAAAEAAAAAAAAAAEAAABZWVkKAAAAACgAAAAoAAAAZAAAAGQAAAAAAAAAzMzMAAAAAABQAAAAUAAAAGQAAABkAAAAAAAAABcAAAAUAAAAAAAAAAAAAAD/fwAA/38AAAAAAAAJAAAABAAAAAAAAAAeAAAAaAAAAAAAAAAAAAAAAAAAAAAAAAAAAAAAECcAABAnAAAAAAAAAAAAAAAAAAAAAAAAAAAAAAAAAAAAAAAAAAAAABQAAAAAAAAAwMD/AAAAAABkAAAAMgAAAAAAAABkAAAAAAAAAH9/fwAKAAAAIgAAABgAAAAAAAAAAAAAAAAAAAAAAAAAAAAAAAAAAAAkAAAAJAAAAAAAAAAHAAAAAAAAAAAAAAAAAAAAAAAAAAAAAAAAAAAAf39/ACUAAABYAAAAAAAAAAAAAAAAAAAAAAAAAAAAAAAAAAAAAAAAAAAAAAAAAAAAAAAAAAAAAAA/AAAAAAAAAKCGAQAAAAAAAAAAAAAAAAAMAAAAAQAAAAAAAAAAAAAAAAAAAB8AAABUAAAAAAAABQAAAAEAAAAAAAAAAAAAAAAAAAAAAAAAAAAAAAAAAAAAAAAAAAAAAAJ/f38AWVlZA8zMzADAwP8Af39/AAAAAAAAAAAAAAAAAAAAAAAAAAAAIQAAABgAAAAUAAAAFAMAALMLAAB/NwAAuScAABAAAAAmAAAACAAAAAAAAAAAAAAA"/>
               </a:ext>
             </a:extLst>
           </p:cNvSpPr>
@@ -9278,7 +9278,7 @@
             <a:picLocks noChangeAspect="1"/>
             <a:extLst>
               <a:ext uri="smNativeData">
-                <pr:smNativeData xmlns:pr="smNativeData" xmlns="smNativeData" val="SMDATA_17_LkR5ZhMAAAAlAAAAEQAAAC8BAAAAkAAAAEgAAACQAAAASAAAAAAAAAAAAAAAAAAAAAEAAABQAAAAAAAAAAAA4D8AAAAAAADgPwAAAAAAAOA/AAAAAAAA4D8AAAAAAADgPwAAAAAAAOA/AAAAAAAA4D8AAAAAAADgPwAAAAAAAOA/AAAAAAAA4D8CAAAAjAAAAAAAAAAAAAAAQoX0DP///wgAAAAAAAAAAAAAAAAAAAAAAAAAAAAAAAAAAAAAZAAAAAEAAABAAAAAAAAAAAAAAAAAAAAAAAAAAAAAAAAAAAAAAAAAAAAAAAAAAAAAAAAAAAAAAAAAAAAAAAAAAAAAAAAAAAAAAAAAAAAAAAAAAAAAAAAAAAAAAAAAAAAAFAAAADwAAAAAAAAAAAAAAAAAAAkUAAAAAQAAABQAAAAUAAAAFAAAAAEAAAAAAAAAZAAAAGQAAAAAAAAAZAAAAGQAAAAVAAAAYAAAAAAAAAAAAAAADwAAACADAAAAAAAAAAAAAAEAAACgMgAAVgcAAKr4//8BAAAAf39/AAEAAABkAAAAAAAAABQAAABAHwAAAAAAACYAAAAAAAAAwOD//wAAAAAmAAAAZAAAABYAAABMAAAAAAAAAAAAAAAEAAAAAAAAAAEAAABZWVkKAAAAACgAAAAoAAAAZAAAAGQAAAAAAAAAzMzMAAAAAABQAAAAUAAAAGQAAABkAAAAAAAAAAcAAAA4AAAAAAAAAAAAAAAAAAAA////AAAAAAAAAAAAAAAAAAAAAAAAAAAAAAAAAAAAAABkAAAAZAAAAAAAAAAjAAAABAAAAGQAAAAXAAAAFAAAAAAAAAAAAAAA/38AAP9/AAAAAAAACQAAAAQAAAAAAAAAHgAAAGgAAAAAAAAAAAAAAAAAAAAAAAAAAAAAABAnAAAQJwAAAAAAAAAAAAAAAAAAAAAAAAAAAAAAAAAAAAAAAAAAAAAUAAAAAAAAAMDA/wAAAAAAZAAAADIAAAAAAAAAZAAAAAAAAAB/f38ACgAAACIAAAAYAAAAAAAAAAAAAAAAAAAAAAAAAAAAAAAAAAAAJAAAACQAAAAAAAAABwAAAAAAAAAAAAAAAAAAAAAAAAAAAAAAAAAAAH9/fwAlAAAAWAAAAAAAAAAAAAAAAAAAAAAAAAAAAAAAAAAAAAAAAAAAAAAAAAAAAAAAAAAAAAAAPwAAAAAAAACghgEAAAAAAAAAAAAAAAAADAAAAAEAAAAAAAAAAAAAAAAAAAAfAAAAVAAAAEKF9AX///8BAAAAAAAAAAAAAAAAAAAAAAAAAAAAAAAAAAAAAAAAAAAAAAACf39/AFlZWQPMzMwAwMD/AH9/fwAAAAAAAAAAAAAAAAD///8AAAAAACEAAAAYAAAAFAAAAKADAACZDgAAIiMAAKUnAAAQAAAAJgAAAAgAAAD//////////w=="/>
+                <pr:smNativeData xmlns:pr="smNativeData" xmlns="smNativeData" val="SMDATA_17_FUV5ZhMAAAAlAAAAEQAAAC8BAAAAkAAAAEgAAACQAAAASAAAAAAAAAAAAAAAAAAAAAEAAABQAAAAAAAAAAAA4D8AAAAAAADgPwAAAAAAAOA/AAAAAAAA4D8AAAAAAADgPwAAAAAAAOA/AAAAAAAA4D8AAAAAAADgPwAAAAAAAOA/AAAAAAAA4D8CAAAAjAAAAAAAAAAAAAAAQoX0DP///wgAAAAAAAAAAAAAAAAAAAAAAAAAAAAAAAAAAAAAZAAAAAEAAABAAAAAAAAAAAAAAAAAAAAAAAAAAAAAAAAAAAAAAAAAAAAAAAAAAAAAAAAAAAAAAAAAAAAAAAAAAAAAAAAAAAAAAAAAAAAAAAAAAAAAAAAAAAAAAAAAAAAAFAAAADwAAAAAAAAAAAAAAAAAAAkUAAAAAQAAABQAAAAUAAAAFAAAAAEAAAAAAAAAZAAAAGQAAAAAAAAAZAAAAGQAAAAVAAAAYAAAAAAAAAAAAAAADwAAACADAAAAAAAAAAAAAAEAAACgMgAAVgcAAKr4//8BAAAAf39/AAEAAABkAAAAAAAAABQAAABAHwAAAAAAACYAAAAAAAAAwOD//wAAAAAmAAAAZAAAABYAAABMAAAAAAAAAAAAAAAEAAAAAAAAAAEAAABZWVkKAAAAACgAAAAoAAAAZAAAAGQAAAAAAAAAzMzMAAAAAABQAAAAUAAAAGQAAABkAAAAAAAAAAcAAAA4AAAAAAAAAAAAAAAAAAAA////AAAAAAAAAAAAAAAAAAAAAAAAAAAAAAAAAAAAAABkAAAAZAAAAAAAAAAjAAAABAAAAGQAAAAXAAAAFAAAAAAAAAAAAAAA/38AAP9/AAAAAAAACQAAAAQAAAAAAAAAHgAAAGgAAAAAAAAAAAAAAAAAAAAAAAAAAAAAABAnAAAQJwAAAAAAAAAAAAAAAAAAAAAAAAAAAAAAAAAAAAAAAAAAAAAUAAAAAAAAAMDA/wAAAAAAZAAAADIAAAAAAAAAZAAAAAAAAAB/f38ACgAAACIAAAAYAAAAAAAAAAAAAAAAAAAAAAAAAAAAAAAAAAAAJAAAACQAAAAAAAAABwAAAAAAAAAAAAAAAAAAAAAAAAAAAAAAAAAAAH9/fwAlAAAAWAAAAAAAAAAAAAAAAAAAAAAAAAAAAAAAAAAAAAAAAAAAAAAAAAAAAAAAAAAAAAAAPwAAAAAAAACghgEAAAAAAAAAAAAAAAAADAAAAAEAAAAAAAAAAAAAAAAAAAAfAAAAVAAAAEKF9AX///8BAAAAAAAAAAAAAAAAAAAAAAAAAAAAAAAAAAAAAAAAAAAAAAACf39/AFlZWQPMzMwAwMD/AH9/fwAAAAAAAAAAAAAAAAD///8AAAAAACEAAAAYAAAAFAAAAKADAACZDgAAIiMAAKUnAAAQAAAAJgAAAAgAAAD//////////w=="/>
               </a:ext>
             </a:extLst>
           </p:cNvPicPr>
@@ -9344,7 +9344,7 @@
             <a:spLocks noGrp="1" noChangeArrowheads="1"/>
             <a:extLst>
               <a:ext uri="smNativeData">
-                <pr:smNativeData xmlns:pr="smNativeData" xmlns="smNativeData" val="SMDATA_15_LkR5ZhMAAAAlAAAAZAAAAA0AAAAAkAAAAJAAAACQAAAAkAAAAAAAAAAAAAAAAAAAAAEAAABQAAAAAAAAAAAA4D8AAAAAAADgPwAAAAAAAOA/AAAAAAAA4D8AAAAAAADgPwAAAAAAAOA/AAAAAAAA4D8AAAAAAADgPwAAAAAAAOA/AAAAAAAA4D8CAAAAjAAAAAAAAAAAAAAAQoX0DP///wgAAAAAAAAAAAAAAAAAAAAAAAAAAAAAAAAAAAAAZAAAAAEAAABAAAAAAAAAAAAAAAAAAAAAAAAAAAAAAAAAAAAAAAAAAAAAAAAAAAAAAAAAAAAAAAAAAAAAAAAAAAAAAAAAAAAAAAAAAAAAAAAAAAAAAAAAAAAAAAAAAAAAFAAAADwAAAAAAAAAAAAAAAAAAAkUAAAAAQAAABQAAAAUAAAAFAAAAAEAAAAAAAAAZAAAAGQAAAAAAAAAZAAAAGQAAAAVAAAAYAAAAAAAAAAAAAAADwAAACADAAAAAAAAAAAAAAEAAACgMgAAVgcAAKr4//8BAAAAf39/AAEAAABkAAAAAAAAABQAAABAHwAAAAAAACYAAAAAAAAAwOD//wAAAAAmAAAAZAAAABYAAABMAAAAAAAAAAAAAAAEAAAAAAAAAAEAAABZWVkKAAAAACgAAAAoAAAAZAAAAGQAAAAAAAAAzMzMAAAAAABQAAAAUAAAAGQAAABkAAAAAAAAABcAAAAUAAAAAAAAAAAAAAD/fwAA/38AAAAAAAAJAAAABAAAAAAAAAAeAAAAaAAAAAAAAAAAAAAAAAAAAAAAAAAAAAAAECcAABAnAAAAAAAAAAAAAAAAAAAAAAAAAAAAAAAAAAAAAAAAAAAAABQAAAAAAAAAwMD/AAAAAABkAAAAMgAAAAAAAABkAAAAAAAAAH9/fwAKAAAAIgAAABgAAAAAAAAAAAAAAAAAAAAAAAAAAAAAAAAAAAAkAAAAJAAAAAAAAAAHAAAAAAAAAAAAAAAAAAAAAAAAAAAAAAAAAAAAf39/ACUAAABYAAAAAAAAAAAAAAAAAAAAAAAAAAAAAAAAAAAAAAAAAAAAAAAAAAAAAAAAAAAAAAA/AAAAAAAAAKCGAQAAAAAAAAAAAAAAAAAMAAAAAQAAAAAAAAAAAAAAAAAAAB8AAABUAAAAQoX0Bf///wEAAAAAAAAAAAAAAAAAAAAAAAAAAAAAAAAAAAAAAAAAAAAAAAJ/f38AWVlZA8zMzADAwP8Af39/AAAAAAAAAAAAAAAAAAAAAAAAAAAAIQAAABgAAAAUAAAAFAMAALYCAAB/NwAAvwoAABAAAAAmAAAACAAAAAAAAAAAAAAA"/>
+                <pr:smNativeData xmlns:pr="smNativeData" xmlns="smNativeData" val="SMDATA_15_FUV5ZhMAAAAlAAAAZAAAAA0AAAAAkAAAAJAAAACQAAAAkAAAAAAAAAAAAAAAAAAAAAEAAABQAAAAAAAAAAAA4D8AAAAAAADgPwAAAAAAAOA/AAAAAAAA4D8AAAAAAADgPwAAAAAAAOA/AAAAAAAA4D8AAAAAAADgPwAAAAAAAOA/AAAAAAAA4D8CAAAAjAAAAAAAAAAAAAAAQoX0DP///wgAAAAAAAAAAAAAAAAAAAAAAAAAAAAAAAAAAAAAZAAAAAEAAABAAAAAAAAAAAAAAAAAAAAAAAAAAAAAAAAAAAAAAAAAAAAAAAAAAAAAAAAAAAAAAAAAAAAAAAAAAAAAAAAAAAAAAAAAAAAAAAAAAAAAAAAAAAAAAAAAAAAAFAAAADwAAAAAAAAAAAAAAAAAAAkUAAAAAQAAABQAAAAUAAAAFAAAAAEAAAAAAAAAZAAAAGQAAAAAAAAAZAAAAGQAAAAVAAAAYAAAAAAAAAAAAAAADwAAACADAAAAAAAAAAAAAAEAAACgMgAAVgcAAKr4//8BAAAAf39/AAEAAABkAAAAAAAAABQAAABAHwAAAAAAACYAAAAAAAAAwOD//wAAAAAmAAAAZAAAABYAAABMAAAAAAAAAAAAAAAEAAAAAAAAAAEAAABZWVkKAAAAACgAAAAoAAAAZAAAAGQAAAAAAAAAzMzMAAAAAABQAAAAUAAAAGQAAABkAAAAAAAAABcAAAAUAAAAAAAAAAAAAAD/fwAA/38AAAAAAAAJAAAABAAAAAAAAAAeAAAAaAAAAAAAAAAAAAAAAAAAAAAAAAAAAAAAECcAABAnAAAAAAAAAAAAAAAAAAAAAAAAAAAAAAAAAAAAAAAAAAAAABQAAAAAAAAAwMD/AAAAAABkAAAAMgAAAAAAAABkAAAAAAAAAH9/fwAKAAAAIgAAABgAAAAAAAAAAAAAAAAAAAAAAAAAAAAAAAAAAAAkAAAAJAAAAAAAAAAHAAAAAAAAAAAAAAAAAAAAAAAAAAAAAAAAAAAAf39/ACUAAABYAAAAAAAAAAAAAAAAAAAAAAAAAAAAAAAAAAAAAAAAAAAAAAAAAAAAAAAAAAAAAAA/AAAAAAAAAKCGAQAAAAAAAAAAAAAAAAAMAAAAAQAAAAAAAAAAAAAAAAAAAB8AAABUAAAAAAAABQAAAAEAAAAAAAAAAAAAAAAAAAAAAAAAAAAAAAAAAAAAAAAAAAAAAAJ/f38AWVlZA8zMzADAwP8Af39/AAAAAAAAAAAAAAAAAAAAAAAAAAAAIQAAABgAAAAUAAAAFAMAALYCAAB/NwAAvwoAABAAAAAmAAAACAAAAAAAAAAAAAAA"/>
               </a:ext>
             </a:extLst>
           </p:cNvSpPr>
@@ -9371,7 +9371,7 @@
             <a:spLocks noGrp="1" noChangeArrowheads="1"/>
             <a:extLst>
               <a:ext uri="smNativeData">
-                <pr:smNativeData xmlns:pr="smNativeData" xmlns="smNativeData" val="SMDATA_15_LkR5ZhMAAAAlAAAAZAAAAA0AAAAAkAAAAJAAAACQAAAAkAAAAAAAAAAAAAAAAAAAAAEAAABQAAAAAAAAAAAA4D8AAAAAAADgPwAAAAAAAOA/AAAAAAAA4D8AAAAAAADgPwAAAAAAAOA/AAAAAAAA4D8AAAAAAADgPwAAAAAAAOA/AAAAAAAA4D8CAAAAjAAAAAAAAAAAAAAAQoX0DP///wgAAAAAAAAAAAAAAAAAAAAAAAAAAAAAAAAAAAAAZAAAAAEAAABAAAAAAAAAAAAAAAAAAAAAAAAAAAAAAAAAAAAAAAAAAAAAAAAAAAAAAAAAAAAAAAAAAAAAAAAAAAAAAAAAAAAAAAAAAAAAAAAAAAAAAAAAAAAAAAAAAAAAFAAAADwAAAAAAAAAAAAAAAAAAAkUAAAAAQAAABQAAAAUAAAAFAAAAAEAAAAAAAAAZAAAAGQAAAAAAAAAZAAAAGQAAAAVAAAAYAAAAAAAAAAAAAAADwAAACADAAAAAAAAAAAAAAEAAACgMgAAVgcAAKr4//8BAAAAf39/AAEAAABkAAAAAAAAABQAAABAHwAAAAAAACYAAAAAAAAAwOD//wAAAAAmAAAAZAAAABYAAABMAAAAAAAAAAAAAAAEAAAAAAAAAAEAAABZWVkKAAAAACgAAAAoAAAAZAAAAGQAAAAAAAAAzMzMAAAAAABQAAAAUAAAAGQAAABkAAAAAAAAABcAAAAUAAAAAAAAAAAAAAD/fwAA/38AAAAAAAAJAAAABAAAAAAAAAAeAAAAaAAAAAAAAAAAAAAAAAAAAAAAAAAAAAAAECcAABAnAAAAAAAAAAAAAAAAAAAAAAAAAAAAAAAAAAAAAAAAAAAAABQAAAAAAAAAwMD/AAAAAABkAAAAMgAAAAAAAABkAAAAAAAAAH9/fwAKAAAAIgAAABgAAAAAAAAAAAAAAAAAAAAAAAAAAAAAAAAAAAAkAAAAJAAAAAAAAAAHAAAAAAAAAAAAAAAAAAAAAAAAAAAAAAAAAAAAf39/ACUAAABYAAAAAAAAAAAAAAAAAAAAAAAAAAAAAAAAAAAAAAAAAAAAAAAAAAAAAAAAAAAAAAA/AAAAAAAAAKCGAQAAAAAAAAAAAAAAAAAMAAAAAQAAAAAAAAAAAAAAAAAAAB8AAABUAAAAQoX0Bf///wEAAAAAAAAAAAAAAAAAAAAAAAAAAAAAAAAAAAAAAAAAAAAAAAJ/f38AWVlZA8zMzADAwP8Af39/AAAAAAAAAAAAAAAAAAAAAAAAAAAAIQAAABgAAAAUAAAAFAMAALMLAAB/NwAAuScAABAAAAAmAAAACAAAAAAAAAAAAAAA"/>
+                <pr:smNativeData xmlns:pr="smNativeData" xmlns="smNativeData" val="SMDATA_15_FUV5ZhMAAAAlAAAAZAAAAA0AAAAAkAAAAJAAAACQAAAAkAAAAAAAAAAAAAAAAAAAAAEAAABQAAAAAAAAAAAA4D8AAAAAAADgPwAAAAAAAOA/AAAAAAAA4D8AAAAAAADgPwAAAAAAAOA/AAAAAAAA4D8AAAAAAADgPwAAAAAAAOA/AAAAAAAA4D8CAAAAjAAAAAAAAAAAAAAAQoX0DP///wgAAAAAAAAAAAAAAAAAAAAAAAAAAAAAAAAAAAAAZAAAAAEAAABAAAAAAAAAAAAAAAAAAAAAAAAAAAAAAAAAAAAAAAAAAAAAAAAAAAAAAAAAAAAAAAAAAAAAAAAAAAAAAAAAAAAAAAAAAAAAAAAAAAAAAAAAAAAAAAAAAAAAFAAAADwAAAAAAAAAAAAAAAAAAAkUAAAAAQAAABQAAAAUAAAAFAAAAAEAAAAAAAAAZAAAAGQAAAAAAAAAZAAAAGQAAAAVAAAAYAAAAAAAAAAAAAAADwAAACADAAAAAAAAAAAAAAEAAACgMgAAVgcAAKr4//8BAAAAf39/AAEAAABkAAAAAAAAABQAAABAHwAAAAAAACYAAAAAAAAAwOD//wAAAAAmAAAAZAAAABYAAABMAAAAAAAAAAAAAAAEAAAAAAAAAAEAAABZWVkKAAAAACgAAAAoAAAAZAAAAGQAAAAAAAAAzMzMAAAAAABQAAAAUAAAAGQAAABkAAAAAAAAABcAAAAUAAAAAAAAAAAAAAD/fwAA/38AAAAAAAAJAAAABAAAAAAAAAAeAAAAaAAAAAAAAAAAAAAAAAAAAAAAAAAAAAAAECcAABAnAAAAAAAAAAAAAAAAAAAAAAAAAAAAAAAAAAAAAAAAAAAAABQAAAAAAAAAwMD/AAAAAABkAAAAMgAAAAAAAABkAAAAAAAAAH9/fwAKAAAAIgAAABgAAAAAAAAAAAAAAAAAAAAAAAAAAAAAAAAAAAAkAAAAJAAAAAAAAAAHAAAAAAAAAAAAAAAAAAAAAAAAAAAAAAAAAAAAf39/ACUAAABYAAAAAAAAAAAAAAAAAAAAAAAAAAAAAAAAAAAAAAAAAAAAAAAAAAAAAAAAAAAAAAA/AAAAAAAAAKCGAQAAAAAAAAAAAAAAAAAMAAAAAQAAAAAAAAAAAAAAAAAAAB8AAABUAAAAAAAABQAAAAEAAAAAAAAAAAAAAAAAAAAAAAAAAAAAAAAAAAAAAAAAAAAAAAJ/f38AWVlZA8zMzADAwP8Af39/AAAAAAAAAAAAAAAAAAAAAAAAAAAAIQAAABgAAAAUAAAAFAMAALMLAAB/NwAAuScAABAAAAAmAAAACAAAAAAAAAAAAAAA"/>
               </a:ext>
             </a:extLst>
           </p:cNvSpPr>
@@ -9448,7 +9448,7 @@
             <a:spLocks noGrp="1" noChangeArrowheads="1"/>
             <a:extLst>
               <a:ext uri="smNativeData">
-                <pr:smNativeData xmlns:pr="smNativeData" xmlns="smNativeData" val="SMDATA_15_LkR5ZhMAAAAlAAAAZAAAAA0AAAAAkAAAAJAAAACQAAAAkAAAAAAAAAAAAAAAAAAAAAEAAABQAAAAAAAAAAAA4D8AAAAAAADgPwAAAAAAAOA/AAAAAAAA4D8AAAAAAADgPwAAAAAAAOA/AAAAAAAA4D8AAAAAAADgPwAAAAAAAOA/AAAAAAAA4D8CAAAAjAAAAAAAAAAAAAAAQoX0DP///wgAAAAAAAAAAAAAAAAAAAAAAAAAAAAAAAAAAAAAZAAAAAEAAABAAAAAAAAAAAAAAAAAAAAAAAAAAAAAAAAAAAAAAAAAAAAAAAAAAAAAAAAAAAAAAAAAAAAAAAAAAAAAAAAAAAAAAAAAAAAAAAAAAAAAAAAAAAAAAAAAAAAAFAAAADwAAAAAAAAAAAAAAAAAAAkUAAAAAQAAABQAAAAUAAAAFAAAAAEAAAAAAAAAZAAAAGQAAAAAAAAAZAAAAGQAAAAVAAAAYAAAAAAAAAAAAAAADwAAACADAAAAAAAAAAAAAAEAAACgMgAAVgcAAKr4//8BAAAAf39/AAEAAABkAAAAAAAAABQAAABAHwAAAAAAACYAAAAAAAAAwOD//wAAAAAmAAAAZAAAABYAAABMAAAAAAAAAAAAAAAEAAAAAAAAAAEAAABZWVkKAAAAACgAAAAoAAAAZAAAAGQAAAAAAAAAzMzMAAAAAABQAAAAUAAAAGQAAABkAAAAAAAAABcAAAAUAAAAAAAAAAAAAAD/fwAA/38AAAAAAAAJAAAABAAAADtUGRUeAAAAaAAAAAAAAAAAAAAAAAAAAAAAAAAAAAAAECcAABAnAAAAAAAAAAAAAAAAAAAAAAAAAAAAAAAAAAAAAAAAAAAAABQAAAAAAAAAwMD/AAAAAABkAAAAMgAAAAAAAABkAAAAAAAAAH9/fwAKAAAAIgAAABgAAAAAAAAAAAAAAAAAAAAAAAAAAAAAAAAAAAAkAAAAJAAAAAAAAAAHAAAAAAAAAAAAAAAAAAAAAAAAAAAAAAAAAAAAf39/ACUAAABYAAAAAAAAAAAAAAAAAAAAAAAAAAAAAAAAAAAAAAAAAAAAAAAAAAAAAAAAAAAAAAA/AAAAAAAAAKCGAQAAAAAAAAAAAAAAAAAMAAAAAQAAAAAAAAAAAAAAAAAAAB8AAABUAAAAQoX0Bf///wEAAAAAAAAAAAAAAAAAAAAAAAAAAAAAAAAAAAAAAAAAAAAAAAJ/f38AWVlZA8zMzADAwP8Af39/AAAAAAAAAAAAAAAAAAAAAAAAAAAAIQAAABgAAAAUAAAA+gIAAIICAABlNwAAiwoAABAAAAAmAAAACAAAAD0wAAAAAAAA"/>
+                <pr:smNativeData xmlns:pr="smNativeData" xmlns="smNativeData" val="SMDATA_15_FUV5ZhMAAAAlAAAAZAAAAA0AAAAAkAAAAJAAAACQAAAAkAAAAAAAAAAAAAAAAAAAAAEAAABQAAAAAAAAAAAA4D8AAAAAAADgPwAAAAAAAOA/AAAAAAAA4D8AAAAAAADgPwAAAAAAAOA/AAAAAAAA4D8AAAAAAADgPwAAAAAAAOA/AAAAAAAA4D8CAAAAjAAAAAAAAAAAAAAAQoX0DP///wgAAAAAAAAAAAAAAAAAAAAAAAAAAAAAAAAAAAAAZAAAAAEAAABAAAAAAAAAAAAAAAAAAAAAAAAAAAAAAAAAAAAAAAAAAAAAAAAAAAAAAAAAAAAAAAAAAAAAAAAAAAAAAAAAAAAAAAAAAAAAAAAAAAAAAAAAAAAAAAAAAAAAFAAAADwAAAAAAAAAAAAAAAAAAAkUAAAAAQAAABQAAAAUAAAAFAAAAAEAAAAAAAAAZAAAAGQAAAAAAAAAZAAAAGQAAAAVAAAAYAAAAAAAAAAAAAAADwAAACADAAAAAAAAAAAAAAEAAACgMgAAVgcAAKr4//8BAAAAf39/AAEAAABkAAAAAAAAABQAAABAHwAAAAAAACYAAAAAAAAAwOD//wAAAAAmAAAAZAAAABYAAABMAAAAAAAAAAAAAAAEAAAAAAAAAAEAAABZWVkKAAAAACgAAAAoAAAAZAAAAGQAAAAAAAAAzMzMAAAAAABQAAAAUAAAAGQAAABkAAAAAAAAABcAAAAUAAAAAAAAAAAAAAD/fwAA/38AAAAAAAAJAAAABAAAADtUGRUeAAAAaAAAAAAAAAAAAAAAAAAAAAAAAAAAAAAAECcAABAnAAAAAAAAAAAAAAAAAAAAAAAAAAAAAAAAAAAAAAAAAAAAABQAAAAAAAAAwMD/AAAAAABkAAAAMgAAAAAAAABkAAAAAAAAAH9/fwAKAAAAIgAAABgAAAAAAAAAAAAAAAAAAAAAAAAAAAAAAAAAAAAkAAAAJAAAAAAAAAAHAAAAAAAAAAAAAAAAAAAAAAAAAAAAAAAAAAAAf39/ACUAAABYAAAAAAAAAAAAAAAAAAAAAAAAAAAAAAAAAAAAAAAAAAAAAAAAAAAAAAAAAAAAAAA/AAAAAAAAAKCGAQAAAAAAAAAAAAAAAAAMAAAAAQAAAAAAAAAAAAAAAAAAAB8AAABUAAAAQoX0Bf///wEAAAAAAAAAAAAAAAAAAAAAAAAAAAAAAAAAAAAAAAAAAAAAAAJ/f38AWVlZA8zMzADAwP8Af39/AAAAAAAAAAAAAAAAAAAAAAAAAAAAIQAAABgAAAAUAAAA+gIAAIICAABlNwAAiwoAABAAAAAmAAAACAAAAD0wAAAAAAAA"/>
               </a:ext>
             </a:extLst>
           </p:cNvSpPr>
@@ -9515,7 +9515,7 @@
           <p:cNvSpPr>
             <a:extLst>
               <a:ext uri="smNativeData">
-                <pr:smNativeData xmlns:pr="smNativeData" xmlns="smNativeData" val="SMDATA_15_LkR5ZhMAAAAlAAAA9AEAAA0AAAAAOAEAAMYAAAA4AQAAxgAAAAAAAAABAAAAAAAAAAEAAABQAAAAtSRVET1m6b8FJ9au5qX6vwAAAAAAAOA/AAAAAAAA4D8AAAAAAADgPwAAAAAAAOA/AAAAAAAA4D8AAAAAAADgPwAAAAAAAOA/AAAAAAAA4D8CAAAAjAAAAAEAAAAAAAAA8/PzAP///wgAAAAAAAAAAAAAAAAAAAAAAAAAAAAAAAAAAAAAeAAAAAEAAABAAAAAAAAAAAAAAABaAAAAAAAAAAAAAAAAAAAAAAAAAAAAAAAAAAAAAAAAAAAAAAAAAAAAAAAAAAAAAAAAAAAAAAAAAAAAAAAAAAAAAAAAAAAAAAAAAAAAFAAAADwAAAABAAAAAAAAAAE9hQAPAAAAAQAAACMAAAAjAAAAIwAAAB4AAAAAAAAASwAAAEsAAAAAAAAASwAAAEsAAAAVAAAAYAAAAAAAAAAAAAAADwAAACADAAAAAAAAAAAAAAEAAACgMgAAVgcAAKr4//8BAAAAf39/AAEAAABkAAAAAAAAABQAAABAHwAAAAAAACYAAAAAAAAAwOD//wAAAAAmAAAAZAAAABYAAABMAAAAAAAAAAAAAAAEAAAAAAAAAAEAAABZWVkKAAAAACgAAAAoAAAAZAAAAGQAAAAAAAAAzMzMAAAAAABQAAAAUAAAAGQAAABkAAAAAAAAABcAAAAUAAAAAAAAAAAAAAD/fwAA/38AAAAAAAAJAAAABAAAAG+pTlkeAAAAaAAAAAAAAAAAAAAAAAAAAAAAAAAAAAAAECcAABAnAAAAAAAAAAAAAAAAAAAAAAAAAAAAAAAAAAAAAAAAAAAAABQAAAAAAAAAwMD/AAAAAABkAAAAMgAAAAAAAABkAAAAAAAAAH9/fwAKAAAAIgAAABgAAAAAAAAAAAAAAAAAAAAAAAAAAAAAAAAAAAAkAAAAJAAAAAAAAAAHAAAAAAAAAAAAAAAAAAAAAAAAAAAAAAAAAAAAf39/ACUAAABYAAAAAAAAAAAAAAAAAAAAAAAAAAAAAAAAAAAAAAAAAAAAAAAAAAAAAAAAAAAAAAA/AAAAAAAAAKCGAQAAAAAAAAAAAAAAAAAMAAAAAQAAAAAAAAAAAAAAAAAAAB8AAABUAAAA8/PzAP///wEAAAAAAAAAAAAAAAAAAAAAAAAAAAAAAAAAAAAAAAAAAAE9hQB/f38AWVlZA8zMzADAwP8Af39/AAAAAAAAAAAAAAAAAAAAAAAAAAAAIQAAABgAAAAUAAAAvR0AAO0fAADMMgAApCYAABAAAAAmAAAACAAAAP//////////"/>
+                <pr:smNativeData xmlns:pr="smNativeData" xmlns="smNativeData" val="SMDATA_15_FUV5ZhMAAAAlAAAA9AEAAA0AAAAAOAEAAMYAAAA4AQAAxgAAAAAAAAABAAAAAAAAAAEAAABQAAAAtSRVET1m6b8FJ9au5qX6vwAAAAAAAOA/AAAAAAAA4D8AAAAAAADgPwAAAAAAAOA/AAAAAAAA4D8AAAAAAADgPwAAAAAAAOA/AAAAAAAA4D8CAAAAjAAAAAEAAAAAAAAA8/PzAP///wgAAAAAAAAAAAAAAAAAAAAAAAAAAAAAAAAAAAAAeAAAAAEAAABAAAAAAAAAAAAAAABaAAAAAAAAAAAAAAAAAAAAAAAAAAAAAAAAAAAAAAAAAAAAAAAAAAAAAAAAAAAAAAAAAAAAAAAAAAAAAAAAAAAAAAAAAAAAAAAAAAAAFAAAADwAAAABAAAAAAAAAAE9hQAPAAAAAQAAACMAAAAjAAAAIwAAAB4AAAAAAAAASwAAAEsAAAAAAAAASwAAAEsAAAAVAAAAYAAAAAAAAAAAAAAADwAAACADAAAAAAAAAAAAAAEAAACgMgAAVgcAAKr4//8BAAAAf39/AAEAAABkAAAAAAAAABQAAABAHwAAAAAAACYAAAAAAAAAwOD//wAAAAAmAAAAZAAAABYAAABMAAAAAAAAAAAAAAAEAAAAAAAAAAEAAABZWVkKAAAAACgAAAAoAAAAZAAAAGQAAAAAAAAAzMzMAAAAAABQAAAAUAAAAGQAAABkAAAAAAAAABcAAAAUAAAAAAAAAAAAAAD/fwAA/38AAAAAAAAJAAAABAAAAG+pTlkeAAAAaAAAAAAAAAAAAAAAAAAAAAAAAAAAAAAAECcAABAnAAAAAAAAAAAAAAAAAAAAAAAAAAAAAAAAAAAAAAAAAAAAABQAAAAAAAAAwMD/AAAAAABkAAAAMgAAAAAAAABkAAAAAAAAAH9/fwAKAAAAIgAAABgAAAAAAAAAAAAAAAAAAAAAAAAAAAAAAAAAAAAkAAAAJAAAAAAAAAAHAAAAAAAAAAAAAAAAAAAAAAAAAAAAAAAAAAAAf39/ACUAAABYAAAAAAAAAAAAAAAAAAAAAAAAAAAAAAAAAAAAAAAAAAAAAAAAAAAAAAAAAAAAAAA/AAAAAAAAAKCGAQAAAAAAAAAAAAAAAAAMAAAAAQAAAAAAAAAAAAAAAAAAAB8AAABUAAAA8/PzAP///wEAAAAAAAAAAAAAAAAAAAAAAAAAAAAAAAAAAAAAAAAAAAE9hQB/f38AWVlZA8zMzADAwP8Af39/AAAAAAAAAAAAAAAAAAAAAAAAAAAAIQAAABgAAAAUAAAAvR0AAO0fAADMMgAApCYAABAAAAAmAAAACAAAAP//////////"/>
               </a:ext>
             </a:extLst>
           </p:cNvSpPr>
@@ -9587,7 +9587,7 @@
             <a:picLocks noChangeAspect="1"/>
             <a:extLst>
               <a:ext uri="smNativeData">
-                <pr:smNativeData xmlns:pr="smNativeData" xmlns="smNativeData" val="SMDATA_17_LkR5ZhMAAAAlAAAAEQAAAC8BAAAAkAAAAEgAAACQAAAASAAAAAAAAAAAAAAAAAAAAAEAAABQAAAAAAAAAAAA4D8AAAAAAADgPwAAAAAAAOA/AAAAAAAA4D8AAAAAAADgPwAAAAAAAOA/AAAAAAAA4D8AAAAAAADgPwAAAAAAAOA/AAAAAAAA4D8CAAAAjAAAAAAAAAAAAAAAQoX0DP///wgAAAAAAAAAAAAAAAAAAAAAAAAAAAAAAAAAAAAAZAAAAAEAAABAAAAAAAAAAAAAAAAAAAAAAAAAAAAAAAAAAAAAAAAAAAAAAAAAAAAAAAAAAAAAAAAAAAAAAAAAAAAAAAAAAAAAAAAAAAAAAAAAAAAAAAAAAAAAAAAAAAAAFAAAADwAAAAAAAAAAAAAAAAAAAkUAAAAAQAAABQAAAAUAAAAFAAAAAEAAAAAAAAAZAAAAGQAAAAAAAAAZAAAAGQAAAAVAAAAYAAAAAAAAAAAAAAADwAAACADAAAAAAAAAAAAAAEAAACgMgAAVgcAAKr4//8BAAAAf39/AAEAAABkAAAAAAAAABQAAABAHwAAAAAAACYAAAAAAAAAwOD//wAAAAAmAAAAZAAAABYAAABMAAAAAAAAAAAAAAAEAAAAAAAAAAEAAABZWVkKAAAAACgAAAAoAAAAZAAAAGQAAAAAAAAAzMzMAAAAAABQAAAAUAAAAGQAAABkAAAAAAAAAAcAAAA4AAAAAAAAAAAAAAAAAAAA////AAAAAAAAAAAAAAAAAAAAAAAAAAAAAAAAAAAAAABkAAAAZAAAAAAAAAAjAAAABAAAAGQAAAAXAAAAFAAAAAAAAAAAAAAA/38AAP9/AAAAAAAACQAAAAQAAAAOAAAAHgAAAGgAAAAAAAAAAAAAAAAAAAAAAAAAAAAAABAnAAAQJwAAAAAAAAAAAAAAAAAAAAAAAAAAAAAAAAAAAAAAAAAAAAAUAAAAAAAAAMDA/wAAAAAAZAAAADIAAAAAAAAAZAAAAAAAAAB/f38ACgAAACIAAAAYAAAAAAAAAAAAAAAAAAAAAAAAAAAAAAAAAAAAJAAAACQAAAAAAAAABwAAAAAAAAAAAAAAAAAAAAAAAAAAAAAAAAAAAH9/fwAlAAAAWAAAAAAAAAAAAAAAAAAAAAAAAAAAAAAAAAAAAAAAAAAAAAAAAAAAAAAAAAAAAAAAPwAAAAAAAACghgEAAAAAAAAAAAAAAAAADAAAAAEAAAAAAAAAAAAAAAAAAAAfAAAAVAAAAEKF9AX///8BAAAAAAAAAAAAAAAAAAAAAAAAAAAAAAAAAAAAAAAAAAAAAAACf39/AFlZWQPMzMwAwMD/AH9/fwAAAAAAAAAAAAAAAAD///8AAAAAACEAAAAYAAAAFAAAAAUDAAB5CwAAQzcAAMkcAAAQAAAAJgAAAAgAAAD//////////w=="/>
+                <pr:smNativeData xmlns:pr="smNativeData" xmlns="smNativeData" val="SMDATA_17_FUV5ZhMAAAAlAAAAEQAAAC8BAAAAkAAAAEgAAACQAAAASAAAAAAAAAAAAAAAAAAAAAEAAABQAAAAAAAAAAAA4D8AAAAAAADgPwAAAAAAAOA/AAAAAAAA4D8AAAAAAADgPwAAAAAAAOA/AAAAAAAA4D8AAAAAAADgPwAAAAAAAOA/AAAAAAAA4D8CAAAAjAAAAAAAAAAAAAAAQoX0DP///wgAAAAAAAAAAAAAAAAAAAAAAAAAAAAAAAAAAAAAZAAAAAEAAABAAAAAAAAAAAAAAAAAAAAAAAAAAAAAAAAAAAAAAAAAAAAAAAAAAAAAAAAAAAAAAAAAAAAAAAAAAAAAAAAAAAAAAAAAAAAAAAAAAAAAAAAAAAAAAAAAAAAAFAAAADwAAAAAAAAAAAAAAAAAAAkUAAAAAQAAABQAAAAUAAAAFAAAAAEAAAAAAAAAZAAAAGQAAAAAAAAAZAAAAGQAAAAVAAAAYAAAAAAAAAAAAAAADwAAACADAAAAAAAAAAAAAAEAAACgMgAAVgcAAKr4//8BAAAAf39/AAEAAABkAAAAAAAAABQAAABAHwAAAAAAACYAAAAAAAAAwOD//wAAAAAmAAAAZAAAABYAAABMAAAAAAAAAAAAAAAEAAAAAAAAAAEAAABZWVkKAAAAACgAAAAoAAAAZAAAAGQAAAAAAAAAzMzMAAAAAABQAAAAUAAAAGQAAABkAAAAAAAAAAcAAAA4AAAAAAAAAAAAAAAAAAAA////AAAAAAAAAAAAAAAAAAAAAAAAAAAAAAAAAAAAAABkAAAAZAAAAAAAAAAjAAAABAAAAGQAAAAXAAAAFAAAAAAAAAAAAAAA/38AAP9/AAAAAAAACQAAAAQAAAAOAAAAHgAAAGgAAAAAAAAAAAAAAAAAAAAAAAAAAAAAABAnAAAQJwAAAAAAAAAAAAAAAAAAAAAAAAAAAAAAAAAAAAAAAAAAAAAUAAAAAAAAAMDA/wAAAAAAZAAAADIAAAAAAAAAZAAAAAAAAAB/f38ACgAAACIAAAAYAAAAAAAAAAAAAAAAAAAAAAAAAAAAAAAAAAAAJAAAACQAAAAAAAAABwAAAAAAAAAAAAAAAAAAAAAAAAAAAAAAAAAAAH9/fwAlAAAAWAAAAAAAAAAAAAAAAAAAAAAAAAAAAAAAAAAAAAAAAAAAAAAAAAAAAAAAAAAAAAAAPwAAAAAAAACghgEAAAAAAAAAAAAAAAAADAAAAAEAAAAAAAAAAAAAAAAAAAAfAAAAVAAAAEKF9AX///8BAAAAAAAAAAAAAAAAAAAAAAAAAAAAAAAAAAAAAAAAAAAAAAACf39/AFlZWQPMzMwAwMD/AH9/fwAAAAAAAAAAAAAAAAD///8AAAAAACEAAAAYAAAAFAAAAAUDAAB5CwAAQzcAAMkcAAAQAAAAJgAAAAgAAAD//////////w=="/>
               </a:ext>
             </a:extLst>
           </p:cNvPicPr>
@@ -9653,7 +9653,7 @@
             <a:spLocks noGrp="1" noChangeArrowheads="1"/>
             <a:extLst>
               <a:ext uri="smNativeData">
-                <pr:smNativeData xmlns:pr="smNativeData" xmlns="smNativeData" val="SMDATA_15_LkR5ZhMAAAAlAAAAZAAAAA0AAAAAkAAAAJAAAACQAAAAkAAAAAAAAAAAAAAAAAAAAAEAAABQAAAAAAAAAAAA4D8AAAAAAADgPwAAAAAAAOA/AAAAAAAA4D8AAAAAAADgPwAAAAAAAOA/AAAAAAAA4D8AAAAAAADgPwAAAAAAAOA/AAAAAAAA4D8CAAAAjAAAAAAAAAAAAAAAQoX0DP///wgAAAAAAAAAAAAAAAAAAAAAAAAAAAAAAAAAAAAAZAAAAAEAAABAAAAAAAAAAAAAAAAAAAAAAAAAAAAAAAAAAAAAAAAAAAAAAAAAAAAAAAAAAAAAAAAAAAAAAAAAAAAAAAAAAAAAAAAAAAAAAAAAAAAAAAAAAAAAAAAAAAAAFAAAADwAAAAAAAAAAAAAAAAAAAkUAAAAAQAAABQAAAAUAAAAFAAAAAEAAAAAAAAAZAAAAGQAAAAAAAAAZAAAAGQAAAAVAAAAYAAAAAAAAAAAAAAADwAAACADAAAAAAAAAAAAAAEAAACgMgAAVgcAAKr4//8BAAAAf39/AAEAAABkAAAAAAAAABQAAABAHwAAAAAAACYAAAAAAAAAwOD//wAAAAAmAAAAZAAAABYAAABMAAAAAAAAAAAAAAAEAAAAAAAAAAEAAABZWVkKAAAAACgAAAAoAAAAZAAAAGQAAAAAAAAAzMzMAAAAAABQAAAAUAAAAGQAAABkAAAAAAAAABcAAAAUAAAAAAAAAAAAAAD/fwAA/38AAAAAAAAJAAAABAAAAI+nzTQeAAAAaAAAAAAAAAAAAAAAAAAAAAAAAAAAAAAAECcAABAnAAAAAAAAAAAAAAAAAAAAAAAAAAAAAAAAAAAAAAAAAAAAABQAAAAAAAAAwMD/AAAAAABkAAAAMgAAAAAAAABkAAAAAAAAAH9/fwAKAAAAIgAAABgAAAAAAAAAAAAAAAAAAAAAAAAAAAAAAAAAAAAkAAAAJAAAAAAAAAAHAAAAAAAAAAAAAAAAAAAAAAAAAAAAAAAAAAAAf39/ACUAAABYAAAAAAAAAAAAAAAAAAAAAAAAAAAAAAAAAAAAAAAAAAAAAAAAAAAAAAAAAAAAAAA/AAAAAAAAAKCGAQAAAAAAAAAAAAAAAAAMAAAAAQAAAAAAAAAAAAAAAAAAAB8AAABUAAAAQoX0Bf///wEAAAAAAAAAAAAAAAAAAAAAAAAAAAAAAAAAAAAAAAAAAAAAAAJ/f38AWVlZA8zMzADAwP8Af39/AAAAAAAAAAAAAAAAAAAAAAAAAAAAIQAAABgAAAAUAAAAFAMAALYCAAB/NwAAvwoAABAAAAAmAAAACAAAADwwAAAAAAAA"/>
+                <pr:smNativeData xmlns:pr="smNativeData" xmlns="smNativeData" val="SMDATA_15_FUV5ZhMAAAAlAAAAZAAAAA0AAAAAkAAAAJAAAACQAAAAkAAAAAAAAAAAAAAAAAAAAAEAAABQAAAAAAAAAAAA4D8AAAAAAADgPwAAAAAAAOA/AAAAAAAA4D8AAAAAAADgPwAAAAAAAOA/AAAAAAAA4D8AAAAAAADgPwAAAAAAAOA/AAAAAAAA4D8CAAAAjAAAAAAAAAAAAAAAQoX0DP///wgAAAAAAAAAAAAAAAAAAAAAAAAAAAAAAAAAAAAAZAAAAAEAAABAAAAAAAAAAAAAAAAAAAAAAAAAAAAAAAAAAAAAAAAAAAAAAAAAAAAAAAAAAAAAAAAAAAAAAAAAAAAAAAAAAAAAAAAAAAAAAAAAAAAAAAAAAAAAAAAAAAAAFAAAADwAAAAAAAAAAAAAAAAAAAkUAAAAAQAAABQAAAAUAAAAFAAAAAEAAAAAAAAAZAAAAGQAAAAAAAAAZAAAAGQAAAAVAAAAYAAAAAAAAAAAAAAADwAAACADAAAAAAAAAAAAAAEAAACgMgAAVgcAAKr4//8BAAAAf39/AAEAAABkAAAAAAAAABQAAABAHwAAAAAAACYAAAAAAAAAwOD//wAAAAAmAAAAZAAAABYAAABMAAAAAAAAAAAAAAAEAAAAAAAAAAEAAABZWVkKAAAAACgAAAAoAAAAZAAAAGQAAAAAAAAAzMzMAAAAAABQAAAAUAAAAGQAAABkAAAAAAAAABcAAAAUAAAAAAAAAAAAAAD/fwAA/38AAAAAAAAJAAAABAAAAI+nzTQeAAAAaAAAAAAAAAAAAAAAAAAAAAAAAAAAAAAAECcAABAnAAAAAAAAAAAAAAAAAAAAAAAAAAAAAAAAAAAAAAAAAAAAABQAAAAAAAAAwMD/AAAAAABkAAAAMgAAAAAAAABkAAAAAAAAAH9/fwAKAAAAIgAAABgAAAAAAAAAAAAAAAAAAAAAAAAAAAAAAAAAAAAkAAAAJAAAAAAAAAAHAAAAAAAAAAAAAAAAAAAAAAAAAAAAAAAAAAAAf39/ACUAAABYAAAAAAAAAAAAAAAAAAAAAAAAAAAAAAAAAAAAAAAAAAAAAAAAAAAAAAAAAAAAAAA/AAAAAAAAAKCGAQAAAAAAAAAAAAAAAAAMAAAAAQAAAAAAAAAAAAAAAAAAAB8AAABUAAAAQoX0Bf///wEAAAAAAAAAAAAAAAAAAAAAAAAAAAAAAAAAAAAAAAAAAAAAAAJ/f38AWVlZA8zMzADAwP8Af39/AAAAAAAAAAAAAAAAAAAAAAAAAAAAIQAAABgAAAAUAAAAFAMAALYCAAB/NwAAvwoAABAAAAAmAAAACAAAADwwAAAAAAAA"/>
               </a:ext>
             </a:extLst>
           </p:cNvSpPr>
@@ -9843,7 +9843,7 @@
                 </a:tc>
                 <a:extLst>
                   <a:ext uri="smNativeData">
-                    <pr:rowheight xmlns="" xmlns:pr="smNativeData" dt="1719223342" type="min" val="381000"/>
+                    <pr:rowheight xmlns="" xmlns:pr="smNativeData" dt="1719223573" type="min" val="381000"/>
                   </a:ext>
                 </a:extLst>
               </a:tr>
@@ -9991,7 +9991,7 @@
                 </a:tc>
                 <a:extLst>
                   <a:ext uri="smNativeData">
-                    <pr:rowheight xmlns="" xmlns:pr="smNativeData" dt="1719223342" type="min" val="381000"/>
+                    <pr:rowheight xmlns="" xmlns:pr="smNativeData" dt="1719223573" type="min" val="381000"/>
                   </a:ext>
                 </a:extLst>
               </a:tr>
@@ -10139,7 +10139,7 @@
                 </a:tc>
                 <a:extLst>
                   <a:ext uri="smNativeData">
-                    <pr:rowheight xmlns="" xmlns:pr="smNativeData" dt="1719223342" type="min" val="381000"/>
+                    <pr:rowheight xmlns="" xmlns:pr="smNativeData" dt="1719223573" type="min" val="381000"/>
                   </a:ext>
                 </a:extLst>
               </a:tr>
@@ -10153,7 +10153,7 @@
           <p:cNvSpPr>
             <a:extLst>
               <a:ext uri="smNativeData">
-                <pr:smNativeData xmlns:pr="smNativeData" xmlns="smNativeData" val="SMDATA_15_LkR5ZhMAAAAlAAAA9AEAAA0AAAAAOAEAAMYAAAA4AQAAxgAAAAAAAAABAAAAAAAAAAEAAABQAAAAEXC47Anh479Fb0gmzk0BwAAAAAAAAOA/AAAAAAAA4D8AAAAAAADgPwAAAAAAAOA/AAAAAAAA4D8AAAAAAADgPwAAAAAAAOA/AAAAAAAA4D8CAAAAjAAAAAEAAAAAAAAA8/PzAP///wgAAAAAAAAAAAAAAAAAAAAAAAAAAAAAAAAAAAAAeAAAAAEAAABAAAAAAAAAAAAAAABaAAAAAAAAAAAAAAAAAAAAAAAAAAAAAAAAAAAAAAAAAAAAAAAAAAAAAAAAAAAAAAAAAAAAAAAAAAAAAAAAAAAAAAAAAAAAAAAAAAAAFAAAADwAAAABAAAAAAAAAAE9hQAPAAAAAQAAACMAAAAjAAAAIwAAAB4AAAAAAAAASwAAAEsAAAAAAAAASwAAAEsAAAAVAAAAYAAAAAAAAAAAAAAADwAAACADAAAAAAAAAAAAAAEAAACgMgAAVgcAAKr4//8BAAAAf39/AAEAAABkAAAAAAAAABQAAABAHwAAAAAAACYAAAAAAAAAwOD//wAAAAAmAAAAZAAAABYAAABMAAAAAAAAAAAAAAAEAAAAAAAAAAEAAABZWVkKAAAAACgAAAAoAAAAZAAAAGQAAAAAAAAAzMzMAAAAAABQAAAAUAAAAGQAAABkAAAAAAAAABcAAAAUAAAAAAAAAAAAAAD/fwAA/38AAAAAAAAJAAAABAAAADkxY2geAAAAaAAAAAAAAAAAAAAAAAAAAAAAAAAAAAAAECcAABAnAAAAAAAAAAAAAAAAAAAAAAAAAAAAAAAAAAAAAAAAAAAAABQAAAAAAAAAwMD/AAAAAABkAAAAMgAAAAAAAABkAAAAAAAAAH9/fwAKAAAAIgAAABgAAAAAAAAAAAAAAAAAAAAAAAAAAAAAAAAAAAAkAAAAJAAAAAAAAAAHAAAAAAAAAAAAAAAAAAAAAAAAAAAAAAAAAAAAf39/ACUAAABYAAAAAAAAAAAAAAAAAAAAAAAAAAAAAAAAAAAAAAAAAAAAAAAAAAAAAAAAAAAAAAA/AAAAAAAAAKCGAQAAAAAAAAAAAAAAAAAMAAAAAQAAAAAAAAAAAAAAAAAAAB8AAABUAAAA8/PzAP///wEAAAAAAAAAAAAAAAAAAAAAAAAAAAAAAAAAAAAAAAAAAAE9hQB/f38AWVlZA8zMzADAwP8Af39/AAAAAAAAAAAAAAAAAAAAAAAAAAAAIQAAABgAAAAUAAAAVR0AAO0iAABkMgAAMCoAABAAAAAmAAAACAAAAP//////////"/>
+                <pr:smNativeData xmlns:pr="smNativeData" xmlns="smNativeData" val="SMDATA_15_FUV5ZhMAAAAlAAAA9AEAAA0AAAAAOAEAAMYAAAA4AQAAxgAAAAAAAAABAAAAAAAAAAEAAABQAAAAEXC47Anh479Fb0gmzk0BwAAAAAAAAOA/AAAAAAAA4D8AAAAAAADgPwAAAAAAAOA/AAAAAAAA4D8AAAAAAADgPwAAAAAAAOA/AAAAAAAA4D8CAAAAjAAAAAEAAAAAAAAA8/PzAP///wgAAAAAAAAAAAAAAAAAAAAAAAAAAAAAAAAAAAAAeAAAAAEAAABAAAAAAAAAAAAAAABaAAAAAAAAAAAAAAAAAAAAAAAAAAAAAAAAAAAAAAAAAAAAAAAAAAAAAAAAAAAAAAAAAAAAAAAAAAAAAAAAAAAAAAAAAAAAAAAAAAAAFAAAADwAAAABAAAAAAAAAAE9hQAPAAAAAQAAACMAAAAjAAAAIwAAAB4AAAAAAAAASwAAAEsAAAAAAAAASwAAAEsAAAAVAAAAYAAAAAAAAAAAAAAADwAAACADAAAAAAAAAAAAAAEAAACgMgAAVgcAAKr4//8BAAAAf39/AAEAAABkAAAAAAAAABQAAABAHwAAAAAAACYAAAAAAAAAwOD//wAAAAAmAAAAZAAAABYAAABMAAAAAAAAAAAAAAAEAAAAAAAAAAEAAABZWVkKAAAAACgAAAAoAAAAZAAAAGQAAAAAAAAAzMzMAAAAAABQAAAAUAAAAGQAAABkAAAAAAAAABcAAAAUAAAAAAAAAAAAAAD/fwAA/38AAAAAAAAJAAAABAAAADkxY2geAAAAaAAAAAAAAAAAAAAAAAAAAAAAAAAAAAAAECcAABAnAAAAAAAAAAAAAAAAAAAAAAAAAAAAAAAAAAAAAAAAAAAAABQAAAAAAAAAwMD/AAAAAABkAAAAMgAAAAAAAABkAAAAAAAAAH9/fwAKAAAAIgAAABgAAAAAAAAAAAAAAAAAAAAAAAAAAAAAAAAAAAAkAAAAJAAAAAAAAAAHAAAAAAAAAAAAAAAAAAAAAAAAAAAAAAAAAAAAf39/ACUAAABYAAAAAAAAAAAAAAAAAAAAAAAAAAAAAAAAAAAAAAAAAAAAAAAAAAAAAAAAAAAAAAA/AAAAAAAAAKCGAQAAAAAAAAAAAAAAAAAMAAAAAQAAAAAAAAAAAAAAAAAAAB8AAABUAAAA8/PzAP///wEAAAAAAAAAAAAAAAAAAAAAAAAAAAAAAAAAAAAAAAAAAAE9hQB/f38AWVlZA8zMzADAwP8Af39/AAAAAAAAAAAAAAAAAAAAAAAAAAAAIQAAABgAAAAUAAAAVR0AAO0iAABkMgAAMCoAABAAAAAmAAAACAAAAP//////////"/>
               </a:ext>
             </a:extLst>
           </p:cNvSpPr>
@@ -10257,7 +10257,7 @@
             <a:spLocks noGrp="1" noChangeArrowheads="1"/>
             <a:extLst>
               <a:ext uri="smNativeData">
-                <pr:smNativeData xmlns:pr="smNativeData" xmlns="smNativeData" val="SMDATA_15_LkR5ZhMAAAAlAAAAZAAAAA0AAAAAkAAAAJAAAACQAAAAkAAAAAAAAAABAAAAAAAAAAEAAABQAAAAAAAAAAAA4D8AAAAAAADgPwAAAAAAAOA/AAAAAAAA4D8AAAAAAADgPwAAAAAAAOA/AAAAAAAA4D8AAAAAAADgPwAAAAAAAOA/AAAAAAAA4D8CAAAAjAAAAAAAAAAAAAAAQoX0DP///wgAAAAAAAAAAAAAAAAAAAAAAAAAAAAAAAAAAAAAZAAAAAEAAABAAAAAAAAAAAAAAAAAAAAAAAAAAAAAAAAAAAAAAAAAAAAAAAAAAAAAAAAAAAAAAAAAAAAAAAAAAAAAAAAAAAAAAAAAAAAAAAAAAAAAAAAAAAAAAAAAAAAAFAAAADwAAAAAAAAAAAAAAAAAAAkUAAAAAQAAABQAAAAUAAAAFAAAAAEAAAAAAAAAZAAAAGQAAAAAAAAAZAAAAGQAAAAVAAAAYAAAAAAAAAAAAAAADwAAACADAAAAAAAAAAAAAAEAAACgMgAAVgcAAKr4//8BAAAAf39/AAEAAABkAAAAAAAAABQAAABAHwAAAAAAACYAAAAAAAAAwOD//wAAAAAmAAAAZAAAABYAAABMAAAAAAAAAAAAAAAEAAAAAAAAAAEAAABZWVkKAAAAACgAAAAoAAAAZAAAAGQAAAAAAAAAzMzMAAAAAABQAAAAUAAAAGQAAABkAAAAAAAAABcAAAAUAAAAAAAAAAAAAAD/fwAA/38AAAAAAAAJAAAABAAAAJx8t8UeAAAAaAAAAAAAAAAAAAAAAAAAAAAAAAAAAAAAECcAABAnAAAAAAAAAAAAAAAAAAAAAAAAAAAAAAAAAAAAAAAAAAAAABQAAAAAAAAAwMD/AAAAAABkAAAAMgAAAAAAAABkAAAAAAAAAH9/fwAKAAAAIgAAABgAAAAAAAAAAAAAAAAAAAAAAAAAAAAAAAAAAAAkAAAAJAAAAAAAAAAHAAAAAAAAAAAAAAAAAAAAAAAAAAAAAAAAAAAAf39/ACUAAABYAAAAAAAAAAAAAAAAAAAAAAAAAAAAAAAAAAAAAAAAAAAAAAAAAAAAAAAAAAAAAAA/AAAAAAAAAKCGAQAAAAAAAAAAAAAAAAAMAAAAAQAAAAAAAAAAAAAAAAAAAB8AAABUAAAAQoX0Bf///wEAAAAAAAAAAAAAAAAAAAAAAAAAAAAAAAAAAAAAAAAAAAAAAAJ/f38AWVlZA8zMzADAwP8Af39/AAAAAAAAAAAAAAAAAAAAAAAAAAAAIQAAABgAAAAUAAAA4gUAAEADAABiNAAAziQAABAAAAAmAAAACAAAAD0wAAAAAAAA"/>
+                <pr:smNativeData xmlns:pr="smNativeData" xmlns="smNativeData" val="SMDATA_15_FUV5ZhMAAAAlAAAAZAAAAA0AAAAAkAAAAJAAAACQAAAAkAAAAAAAAAABAAAAAAAAAAEAAABQAAAAAAAAAAAA4D8AAAAAAADgPwAAAAAAAOA/AAAAAAAA4D8AAAAAAADgPwAAAAAAAOA/AAAAAAAA4D8AAAAAAADgPwAAAAAAAOA/AAAAAAAA4D8CAAAAjAAAAAAAAAAAAAAAQoX0DP///wgAAAAAAAAAAAAAAAAAAAAAAAAAAAAAAAAAAAAAZAAAAAEAAABAAAAAAAAAAAAAAAAAAAAAAAAAAAAAAAAAAAAAAAAAAAAAAAAAAAAAAAAAAAAAAAAAAAAAAAAAAAAAAAAAAAAAAAAAAAAAAAAAAAAAAAAAAAAAAAAAAAAAFAAAADwAAAAAAAAAAAAAAAAAAAkUAAAAAQAAABQAAAAUAAAAFAAAAAEAAAAAAAAAZAAAAGQAAAAAAAAAZAAAAGQAAAAVAAAAYAAAAAAAAAAAAAAADwAAACADAAAAAAAAAAAAAAEAAACgMgAAVgcAAKr4//8BAAAAf39/AAEAAABkAAAAAAAAABQAAABAHwAAAAAAACYAAAAAAAAAwOD//wAAAAAmAAAAZAAAABYAAABMAAAAAAAAAAAAAAAEAAAAAAAAAAEAAABZWVkKAAAAACgAAAAoAAAAZAAAAGQAAAAAAAAAzMzMAAAAAABQAAAAUAAAAGQAAABkAAAAAAAAABcAAAAUAAAAAAAAAAAAAAD/fwAA/38AAAAAAAAJAAAABAAAAJx8t8UeAAAAaAAAAAAAAAAAAAAAAAAAAAAAAAAAAAAAECcAABAnAAAAAAAAAAAAAAAAAAAAAAAAAAAAAAAAAAAAAAAAAAAAABQAAAAAAAAAwMD/AAAAAABkAAAAMgAAAAAAAABkAAAAAAAAAH9/fwAKAAAAIgAAABgAAAAAAAAAAAAAAAAAAAAAAAAAAAAAAAAAAAAkAAAAJAAAAAAAAAAHAAAAAAAAAAAAAAAAAAAAAAAAAAAAAAAAAAAAf39/ACUAAABYAAAAAAAAAAAAAAAAAAAAAAAAAAAAAAAAAAAAAAAAAAAAAAAAAAAAAAAAAAAAAAA/AAAAAAAAAKCGAQAAAAAAAAAAAAAAAAAMAAAAAQAAAAAAAAAAAAAAAAAAAB8AAABUAAAAQoX0Bf///wEAAAAAAAAAAAAAAAAAAAAAAAAAAAAAAAAAAAAAAAAAAAAAAAJ/f38AWVlZA8zMzADAwP8Af39/AAAAAAAAAAAAAAAAAAAAAAAAAAAAIQAAABgAAAAUAAAA4gUAAEADAABiNAAAziQAABAAAAAmAAAACAAAAD0wAAAAAAAA"/>
               </a:ext>
             </a:extLst>
           </p:cNvSpPr>
@@ -10350,7 +10350,7 @@
           <p:cNvSpPr>
             <a:extLst>
               <a:ext uri="smNativeData">
-                <pr:smNativeData xmlns:pr="smNativeData" xmlns="smNativeData" val="SMDATA_15_LkR5ZhMAAAAlAAAAZAAAAA0AAAAAkAAAAJAAAACQAAAAkAAAAAAAAAABAAAAAAAAAAEAAABQAAAAAAAAAAAA4D8AAAAAAADgPwAAAAAAAOA/AAAAAAAA4D8AAAAAAADgPwAAAAAAAOA/AAAAAAAA4D8AAAAAAADgPwAAAAAAAOA/AAAAAAAA4D8CAAAAjAAAAAAAAAAAAAAAQoX0DP///wgAAAAAAAAAAAAAAAAAAAAAAAAAAAAAAAAAAAAAZAAAAAEAAABAAAAAAAAAAAAAAAAAAAAAAAAAAAAAAAAAAAAAAAAAAAAAAAAAAAAAAAAAAAAAAAAAAAAAAAAAAAAAAAAAAAAAAAAAAAAAAAAAAAAAAAAAAAAAAAAAAAAAFAAAADwAAAAAAAAAAAAAAAAAAAkUAAAAAQAAABQAAAAUAAAAFAAAAAEAAAAAAAAAZAAAAGQAAAAAAAAAZAAAAGQAAAAVAAAAYAAAAAAAAAAAAAAADwAAACADAAAAAAAAAAAAAAEAAACgMgAAVgcAAKr4//8BAAAAf39/AAEAAABkAAAAAAAAABQAAABAHwAAAAAAACYAAAAAAAAAwOD//wAAAAAmAAAAZAAAABYAAABMAAAAAAAAAAAAAAAEAAAAAAAAAAEAAABZWVkKAAAAACgAAAAoAAAAZAAAAGQAAAAAAAAAzMzMAAAAAABQAAAAUAAAAGQAAABkAAAAAAAAABcAAAAUAAAAAAAAAAAAAAD/fwAA/38AAAAAAAAJAAAABAAAAF8AYAAeAAAAaAAAAAAAAAAAAAAAAAAAAAAAAAAAAAAAECcAABAnAAAAAAAAAAAAAAAAAAAAAAAAAAAAAAAAAAAAAAAAAAAAABQAAAAAAAAAwMD/AAAAAABkAAAAMgAAAAAAAABkAAAAAAAAAH9/fwAKAAAAIgAAABgAAAAAAAAAAAAAAAAAAAAAAAAAAAAAAAAAAAAkAAAAJAAAAAAAAAAHAAAAAAAAAAAAAAAAAAAAAAAAAAAAAAAAAAAAf39/ACUAAABYAAAAAAAAAAAAAAAAAAAAAAAAAAAAAAAAAAAAAAAAAAAAAAAAAAAAAAAAAAAAAAA/AAAAAAAAAKCGAQAAAAAAAAAAAAAAAAAMAAAAAQAAAAAAAAAAAAAAAAAAAB8AAABUAAAAQoX0Bf///wEAAAAAAAAAAAAAAAAAAAAAAAAAAAAAAAAAAAAAAAAAAAAAAAJ/f38AWVlZA8zMzADAwP8Af39/AAAAAAAAAAAAAAAAAAAAAAAAAAAAIQAAABgAAAAUAAAAtwQAAMgQAACINQAAsBcAABAAAAAmAAAACAAAAP//////////"/>
+                <pr:smNativeData xmlns:pr="smNativeData" xmlns="smNativeData" val="SMDATA_15_FUV5ZhMAAAAlAAAAZAAAAA0AAAAAkAAAAJAAAACQAAAAkAAAAAAAAAABAAAAAAAAAAEAAABQAAAAAAAAAAAA4D8AAAAAAADgPwAAAAAAAOA/AAAAAAAA4D8AAAAAAADgPwAAAAAAAOA/AAAAAAAA4D8AAAAAAADgPwAAAAAAAOA/AAAAAAAA4D8CAAAAjAAAAAAAAAAAAAAAQoX0DP///wgAAAAAAAAAAAAAAAAAAAAAAAAAAAAAAAAAAAAAZAAAAAEAAABAAAAAAAAAAAAAAAAAAAAAAAAAAAAAAAAAAAAAAAAAAAAAAAAAAAAAAAAAAAAAAAAAAAAAAAAAAAAAAAAAAAAAAAAAAAAAAAAAAAAAAAAAAAAAAAAAAAAAFAAAADwAAAAAAAAAAAAAAAAAAAkUAAAAAQAAABQAAAAUAAAAFAAAAAEAAAAAAAAAZAAAAGQAAAAAAAAAZAAAAGQAAAAVAAAAYAAAAAAAAAAAAAAADwAAACADAAAAAAAAAAAAAAEAAACgMgAAVgcAAKr4//8BAAAAf39/AAEAAABkAAAAAAAAABQAAABAHwAAAAAAACYAAAAAAAAAwOD//wAAAAAmAAAAZAAAABYAAABMAAAAAAAAAAAAAAAEAAAAAAAAAAEAAABZWVkKAAAAACgAAAAoAAAAZAAAAGQAAAAAAAAAzMzMAAAAAABQAAAAUAAAAGQAAABkAAAAAAAAABcAAAAUAAAAAAAAAAAAAAD/fwAA/38AAAAAAAAJAAAABAAAAF8AYAAeAAAAaAAAAAAAAAAAAAAAAAAAAAAAAAAAAAAAECcAABAnAAAAAAAAAAAAAAAAAAAAAAAAAAAAAAAAAAAAAAAAAAAAABQAAAAAAAAAwMD/AAAAAABkAAAAMgAAAAAAAABkAAAAAAAAAH9/fwAKAAAAIgAAABgAAAAAAAAAAAAAAAAAAAAAAAAAAAAAAAAAAAAkAAAAJAAAAAAAAAAHAAAAAAAAAAAAAAAAAAAAAAAAAAAAAAAAAAAAf39/ACUAAABYAAAAAAAAAAAAAAAAAAAAAAAAAAAAAAAAAAAAAAAAAAAAAAAAAAAAAAAAAAAAAAA/AAAAAAAAAKCGAQAAAAAAAAAAAAAAAAAMAAAAAQAAAAAAAAAAAAAAAAAAAB8AAABUAAAAQoX0Bf///wEAAAAAAAAAAAAAAAAAAAAAAAAAAAAAAAAAAAAAAAAAAAAAAAJ/f38AWVlZA8zMzADAwP8Af39/AAAAAAAAAAAAAAAAAAAAAAAAAAAAIQAAABgAAAAUAAAAtwQAAMgQAACINQAAsBcAABAAAAAmAAAACAAAAP//////////"/>
               </a:ext>
             </a:extLst>
           </p:cNvSpPr>
@@ -10429,7 +10429,7 @@
           <p:cNvPicPr>
             <a:extLst>
               <a:ext uri="smNativeData">
-                <pr:smNativeData xmlns:pr="smNativeData" xmlns="smNativeData" val="SMDATA_17_LkR5ZhMAAAAlAAAAEQAAAA0AAAAAkAAAAEgAAACQAAAASAAAAAAAAAAAAAAAAAAAAAEAAABQAAAAAAAAAAAA4D8AAAAAAADgPwAAAAAAAOA/AAAAAAAA4D8AAAAAAADgPwAAAAAAAOA/AAAAAAAA4D8AAAAAAADgPwAAAAAAAOA/AAAAAAAA4D8CAAAAjAAAAAAAAAAAAAAAQoX0DP///wgAAAAAAAAAAAAAAAAAAAAAAAAAAAAAAAAAAAAAZAAAAAEAAABAAAAAAAAAAAAAAAAAAAAAAAAAAAAAAAAAAAAAAAAAAAAAAAAAAAAAAAAAAAAAAAAAAAAAAAAAAAAAAAAAAAAAAAAAAAAAAAAAAAAAAAAAAAAAAAAAAAAAFAAAADwAAAAAAAAAAAAAAAAAAAkUAAAAAQAAABQAAAAUAAAAFAAAAAEAAAAAAAAAZAAAAGQAAAAAAAAAZAAAAGQAAAAVAAAAYAAAAAAAAAAAAAAADwAAACADAAAAAAAAAAAAAAEAAACgMgAAVgcAAKr4//8BAAAAf39/AAEAAABkAAAAAAAAABQAAABAHwAAAAAAACYAAAAAAAAAwOD//wAAAAAmAAAAZAAAABYAAABMAAAAAAAAAAAAAAAEAAAAAAAAAAEAAABZWVkKAAAAACgAAAAoAAAAZAAAAGQAAAAAAAAAzMzMAAAAAABQAAAAUAAAAGQAAABkAAAAAAAAAAcAAAA4AAAAAAAAAAAAAAAAAAAA////AAAAAAAAAAAAAAAAAAAAAAAAAAAAAAAAAAAAAABkAAAAZAAAAAAAAAAjAAAABAAAAGQAAAAXAAAAFAAAAAAAAAAAAAAA/38AAP9/AAAAAAAACQAAAAQAAAAAAAAAHgAAAGgAAAAAAAAAAAAAAAAAAAAAAAAAAAAAABAnAAAQJwAAAAAAAAAAAAAAAAAAAAAAAAAAAAAAAAAAAAAAAAAAAAAUAAAAAAAAAMDA/wAAAAAAZAAAADIAAAAAAAAAZAAAAAAAAAB/f38ACgAAACIAAAAYAAAAAAAAAAAAAAAAAAAAAAAAAAAAAAAAAAAAJAAAACQAAAAAAAAABwAAAAAAAAAAAAAAAAAAAAAAAAAAAAAAAAAAAH9/fwAlAAAAWAAAAAAAAAAAAAAAAAAAAAAAAAAAAAAAAAAAAAAAAAAAAAAAAAAAAAAAAAAAAAAAPwAAAAAAAACghgEAAAAAAAAAAAAAAAAADAAAAAEAAAAAAAAAAAAAAAAAAAAfAAAAVAAAAEKF9AX///8BAAAAAAAAAAAAAAAAAAAAAAAAAAAAAAAAAAAAAAAAAAAAAAACf39/AFlZWQPMzMwAwMD/AH9/fwAAAAAAAAAAAAAAAAD///8AAAAAACEAAAAYAAAAFAAAAEYFAAD3GgAAmAkAAEkfAAAQAAAAJgAAAAgAAAD//////////w=="/>
+                <pr:smNativeData xmlns:pr="smNativeData" xmlns="smNativeData" val="SMDATA_17_FUV5ZhMAAAAlAAAAEQAAAA0AAAAAkAAAAEgAAACQAAAASAAAAAAAAAAAAAAAAAAAAAEAAABQAAAAAAAAAAAA4D8AAAAAAADgPwAAAAAAAOA/AAAAAAAA4D8AAAAAAADgPwAAAAAAAOA/AAAAAAAA4D8AAAAAAADgPwAAAAAAAOA/AAAAAAAA4D8CAAAAjAAAAAAAAAAAAAAAQoX0DP///wgAAAAAAAAAAAAAAAAAAAAAAAAAAAAAAAAAAAAAZAAAAAEAAABAAAAAAAAAAAAAAAAAAAAAAAAAAAAAAAAAAAAAAAAAAAAAAAAAAAAAAAAAAAAAAAAAAAAAAAAAAAAAAAAAAAAAAAAAAAAAAAAAAAAAAAAAAAAAAAAAAAAAFAAAADwAAAAAAAAAAAAAAAAAAAkUAAAAAQAAABQAAAAUAAAAFAAAAAEAAAAAAAAAZAAAAGQAAAAAAAAAZAAAAGQAAAAVAAAAYAAAAAAAAAAAAAAADwAAACADAAAAAAAAAAAAAAEAAACgMgAAVgcAAKr4//8BAAAAf39/AAEAAABkAAAAAAAAABQAAABAHwAAAAAAACYAAAAAAAAAwOD//wAAAAAmAAAAZAAAABYAAABMAAAAAAAAAAAAAAAEAAAAAAAAAAEAAABZWVkKAAAAACgAAAAoAAAAZAAAAGQAAAAAAAAAzMzMAAAAAABQAAAAUAAAAGQAAABkAAAAAAAAAAcAAAA4AAAAAAAAAAAAAAAAAAAA////AAAAAAAAAAAAAAAAAAAAAAAAAAAAAAAAAAAAAABkAAAAZAAAAAAAAAAjAAAABAAAAGQAAAAXAAAAFAAAAAAAAAAAAAAA/38AAP9/AAAAAAAACQAAAAQAAAAAAAAAHgAAAGgAAAAAAAAAAAAAAAAAAAAAAAAAAAAAABAnAAAQJwAAAAAAAAAAAAAAAAAAAAAAAAAAAAAAAAAAAAAAAAAAAAAUAAAAAAAAAMDA/wAAAAAAZAAAADIAAAAAAAAAZAAAAAAAAAB/f38ACgAAACIAAAAYAAAAAAAAAAAAAAAAAAAAAAAAAAAAAAAAAAAAJAAAACQAAAAAAAAABwAAAAAAAAAAAAAAAAAAAAAAAAAAAAAAAAAAAH9/fwAlAAAAWAAAAAAAAAAAAAAAAAAAAAAAAAAAAAAAAAAAAAAAAAAAAAAAAAAAAAAAAAAAAAAAPwAAAAAAAACghgEAAAAAAAAAAAAAAAAADAAAAAEAAAAAAAAAAAAAAAAAAAAfAAAAVAAAAEKF9AX///8BAAAAAAAAAAAAAAAAAAAAAAAAAAAAAAAAAAAAAAAAAAAAAAACf39/AFlZWQPMzMwAwMD/AH9/fwAAAAAAAAAAAAAAAAD///8AAAAAACEAAAAYAAAAFAAAAEYFAAD3GgAAmAkAAEkfAAAQAAAAJgAAAAgAAAD//////////w=="/>
               </a:ext>
             </a:extLst>
           </p:cNvPicPr>
@@ -10462,7 +10462,7 @@
           <p:cNvPicPr>
             <a:extLst>
               <a:ext uri="smNativeData">
-                <pr:smNativeData xmlns:pr="smNativeData" xmlns="smNativeData" val="SMDATA_17_LkR5ZhMAAAAlAAAAEQAAAA0AAAAAkAAAAEgAAACQAAAASAAAAAAAAAAAAAAAAAAAAAEAAABQAAAAAAAAAAAA4D8AAAAAAADgPwAAAAAAAOA/AAAAAAAA4D8AAAAAAADgPwAAAAAAAOA/AAAAAAAA4D8AAAAAAADgPwAAAAAAAOA/AAAAAAAA4D8CAAAAjAAAAAAAAAAAAAAAQoX0DP///wgAAAAAAAAAAAAAAAAAAAAAAAAAAAAAAAAAAAAAZAAAAAEAAABAAAAAAAAAAAAAAAAAAAAAAAAAAAAAAAAAAAAAAAAAAAAAAAAAAAAAAAAAAAAAAAAAAAAAAAAAAAAAAAAAAAAAAAAAAAAAAAAAAAAAAAAAAAAAAAAAAAAAFAAAADwAAAAAAAAAAAAAAAAAAAkUAAAAAQAAABQAAAAUAAAAFAAAAAEAAAAAAAAAZAAAAGQAAAAAAAAAZAAAAGQAAAAVAAAAYAAAAAAAAAAAAAAADwAAACADAAAAAAAAAAAAAAEAAACgMgAAVgcAAKr4//8BAAAAf39/AAEAAABkAAAAAAAAABQAAABAHwAAAAAAACYAAAAAAAAAwOD//wAAAAAmAAAAZAAAABYAAABMAAAAAAAAAAAAAAAEAAAAAAAAAAEAAABZWVkKAAAAACgAAAAoAAAAZAAAAGQAAAAAAAAAzMzMAAAAAABQAAAAUAAAAGQAAABkAAAAAAAAAAcAAAA4AAAAAAAAAAAAAAAAAAAA////AAAAAAAAAAAAAAAAAAAAAAAAAAAAAAAAAAAAAABkAAAAZAAAAAAAAAAjAAAABAAAAGQAAAAXAAAAFAAAAAAAAAAAAAAA/38AAP9/AAAAAAAACQAAAAQAAADPAQAAHgAAAGgAAAAAAAAAAAAAAAAAAAAAAAAAAAAAABAnAAAQJwAAAAAAAAAAAAAAAAAAAAAAAAAAAAAAAAAAAAAAAAAAAAAUAAAAAAAAAMDA/wAAAAAAZAAAADIAAAAAAAAAZAAAAAAAAAB/f38ACgAAACIAAAAYAAAAAAAAAAAAAAAAAAAAAAAAAAAAAAAAAAAAJAAAACQAAAAAAAAABwAAAAAAAAAAAAAAAAAAAAAAAAAAAAAAAAAAAH9/fwAlAAAAWAAAAAAAAAAAAAAAAAAAAAAAAAAAAAAAAAAAAAAAAAAAAAAAAAAAAAAAAAAAAAAAPwAAAAAAAACghgEAAAAAAAAAAAAAAAAADAAAAAEAAAAAAAAAAAAAAAAAAAAfAAAAVAAAAEKF9AX///8BAAAAAAAAAAAAAAAAAAAAAAAAAAAAAAAAAAAAAAAAAAAAAAACf39/AFlZWQPMzMwAwMD/AH9/fwAAAAAAAAAAAAAAAAD///8AAAAAACEAAAAYAAAAFAAAALAKAAD3GgAAAg8AAEkfAAAQAAAAJgAAAAgAAAD//////////w=="/>
+                <pr:smNativeData xmlns:pr="smNativeData" xmlns="smNativeData" val="SMDATA_17_FUV5ZhMAAAAlAAAAEQAAAA0AAAAAkAAAAEgAAACQAAAASAAAAAAAAAAAAAAAAAAAAAEAAABQAAAAAAAAAAAA4D8AAAAAAADgPwAAAAAAAOA/AAAAAAAA4D8AAAAAAADgPwAAAAAAAOA/AAAAAAAA4D8AAAAAAADgPwAAAAAAAOA/AAAAAAAA4D8CAAAAjAAAAAAAAAAAAAAAQoX0DP///wgAAAAAAAAAAAAAAAAAAAAAAAAAAAAAAAAAAAAAZAAAAAEAAABAAAAAAAAAAAAAAAAAAAAAAAAAAAAAAAAAAAAAAAAAAAAAAAAAAAAAAAAAAAAAAAAAAAAAAAAAAAAAAAAAAAAAAAAAAAAAAAAAAAAAAAAAAAAAAAAAAAAAFAAAADwAAAAAAAAAAAAAAAAAAAkUAAAAAQAAABQAAAAUAAAAFAAAAAEAAAAAAAAAZAAAAGQAAAAAAAAAZAAAAGQAAAAVAAAAYAAAAAAAAAAAAAAADwAAACADAAAAAAAAAAAAAAEAAACgMgAAVgcAAKr4//8BAAAAf39/AAEAAABkAAAAAAAAABQAAABAHwAAAAAAACYAAAAAAAAAwOD//wAAAAAmAAAAZAAAABYAAABMAAAAAAAAAAAAAAAEAAAAAAAAAAEAAABZWVkKAAAAACgAAAAoAAAAZAAAAGQAAAAAAAAAzMzMAAAAAABQAAAAUAAAAGQAAABkAAAAAAAAAAcAAAA4AAAAAAAAAAAAAAAAAAAA////AAAAAAAAAAAAAAAAAAAAAAAAAAAAAAAAAAAAAABkAAAAZAAAAAAAAAAjAAAABAAAAGQAAAAXAAAAFAAAAAAAAAAAAAAA/38AAP9/AAAAAAAACQAAAAQAAADPAQAAHgAAAGgAAAAAAAAAAAAAAAAAAAAAAAAAAAAAABAnAAAQJwAAAAAAAAAAAAAAAAAAAAAAAAAAAAAAAAAAAAAAAAAAAAAUAAAAAAAAAMDA/wAAAAAAZAAAADIAAAAAAAAAZAAAAAAAAAB/f38ACgAAACIAAAAYAAAAAAAAAAAAAAAAAAAAAAAAAAAAAAAAAAAAJAAAACQAAAAAAAAABwAAAAAAAAAAAAAAAAAAAAAAAAAAAAAAAAAAAH9/fwAlAAAAWAAAAAAAAAAAAAAAAAAAAAAAAAAAAAAAAAAAAAAAAAAAAAAAAAAAAAAAAAAAAAAAPwAAAAAAAACghgEAAAAAAAAAAAAAAAAADAAAAAEAAAAAAAAAAAAAAAAAAAAfAAAAVAAAAEKF9AX///8BAAAAAAAAAAAAAAAAAAAAAAAAAAAAAAAAAAAAAAAAAAAAAAACf39/AFlZWQPMzMwAwMD/AH9/fwAAAAAAAAAAAAAAAAD///8AAAAAACEAAAAYAAAAFAAAALAKAAD3GgAAAg8AAEkfAAAQAAAAJgAAAAgAAAD//////////w=="/>
               </a:ext>
             </a:extLst>
           </p:cNvPicPr>
@@ -10527,7 +10527,7 @@
           <p:cNvSpPr>
             <a:extLst>
               <a:ext uri="smNativeData">
-                <pr:smNativeData xmlns:pr="smNativeData" xmlns="smNativeData" val="SMDATA_15_LkR5ZhMAAAAlAAAAZAAAAA0AAAAAkAAAAJAAAACQAAAAkAAAAAAAAAABAAAAAAAAAAEAAABQAAAAAAAAAAAA4D8AAAAAAADgPwAAAAAAAOA/AAAAAAAA4D8AAAAAAADgPwAAAAAAAOA/AAAAAAAA4D8AAAAAAADgPwAAAAAAAOA/AAAAAAAA4D8CAAAAjAAAAAEAAAAAAAAAAT2FAP///wgAAAAAAAAAAAAAAAAAAAAAAAAAAAAAAAAAAAAAeAAAAAEAAABAAAAAAAAAAAAAAABaAAAAAAAAAAAAAAAAAAAAAAAAAAAAAAAAAAAAAAAAAAAAAAAAAAAAAAAAAAAAAAAAAAAAAAAAAAAAAAAAAAAAAAAAAAAAAAAAAAAAFAAAADwAAAAAAAAAAAAAAAAAAAkUAAAAAQAAABQAAAAUAAAAFAAAAAEAAAAAAAAAZAAAAGQAAAAAAAAAZAAAAGQAAAAVAAAAYAAAAAAAAAAAAAAADwAAACADAAAAAAAAAAAAAAEAAACgMgAAVgcAAKr4//8BAAAAf39/AAEAAABkAAAAAAAAABQAAABAHwAAAAAAACYAAAAAAAAAwOD//wAAAAAmAAAAZAAAABYAAABMAAAAAAAAAAAAAAAEAAAAAAAAAAEAAABZWVkKAAAAACgAAAAoAAAAZAAAAGQAAAAAAAAAzMzMAAAAAABQAAAAUAAAAGQAAABkAAAAAAAAABcAAAAUAAAAAAAAAAAAAAD/fwAA/38AAAAAAAAJAAAABAAAAF8AYAAeAAAAaAAAAAAAAAAAAAAAAAAAAAAAAAAAAAAAECcAABAnAAAAAAAAAAAAAAAAAAAAAAAAAAAAAAAAAAAAAAAAAAAAABQAAAAAAAAAwMD/AAAAAABkAAAAMgAAAAAAAABkAAAAAAAAAH9/fwAKAAAAIgAAABgAAAAAAAAAAAAAAAAAAAAAAAAAAAAAAAAAAAAkAAAAJAAAAAAAAAAHAAAAAAAAAAAAAAAAAAAAAAAAAAAAAAAAAAAAf39/ACUAAABYAAAAAAAAAAAAAAAAAAAAAAAAAAAAAAAAAAAAAAAAAAAAAAAAAAAAAAAAAAAAAAA/AAAAAAAAAKCGAQAAAAAAAAAAAAAAAAAMAAAAAQAAAAAAAAAAAAAAAAAAAB8AAABUAAAAAT2FAP///wEAAAAAAAAAAAAAAAAAAAAAAAAAAAAAAAAAAAAAAAAAAAAAAAJ/f38AWVlZA8zMzADAwP8Af39/AAAAAAAAAAAAAAAAAAAAAAAAAAAAIQAAABgAAAAUAAAA4AMAALMWAAAyDQAAniUAABAAAAAmAAAACAAAAP//////////"/>
+                <pr:smNativeData xmlns:pr="smNativeData" xmlns="smNativeData" val="SMDATA_15_FUV5ZhMAAAAlAAAAZAAAAA0AAAAAkAAAAJAAAACQAAAAkAAAAAAAAAABAAAAAAAAAAEAAABQAAAAAAAAAAAA4D8AAAAAAADgPwAAAAAAAOA/AAAAAAAA4D8AAAAAAADgPwAAAAAAAOA/AAAAAAAA4D8AAAAAAADgPwAAAAAAAOA/AAAAAAAA4D8CAAAAjAAAAAEAAAAAAAAAAT2FAP///wgAAAAAAAAAAAAAAAAAAAAAAAAAAAAAAAAAAAAAeAAAAAEAAABAAAAAAAAAAAAAAABaAAAAAAAAAAAAAAAAAAAAAAAAAAAAAAAAAAAAAAAAAAAAAAAAAAAAAAAAAAAAAAAAAAAAAAAAAAAAAAAAAAAAAAAAAAAAAAAAAAAAFAAAADwAAAAAAAAAAAAAAAAAAAkUAAAAAQAAABQAAAAUAAAAFAAAAAEAAAAAAAAAZAAAAGQAAAAAAAAAZAAAAGQAAAAVAAAAYAAAAAAAAAAAAAAADwAAACADAAAAAAAAAAAAAAEAAACgMgAAVgcAAKr4//8BAAAAf39/AAEAAABkAAAAAAAAABQAAABAHwAAAAAAACYAAAAAAAAAwOD//wAAAAAmAAAAZAAAABYAAABMAAAAAAAAAAAAAAAEAAAAAAAAAAEAAABZWVkKAAAAACgAAAAoAAAAZAAAAGQAAAAAAAAAzMzMAAAAAABQAAAAUAAAAGQAAABkAAAAAAAAABcAAAAUAAAAAAAAAAAAAAD/fwAA/38AAAAAAAAJAAAABAAAAF8AYAAeAAAAaAAAAAAAAAAAAAAAAAAAAAAAAAAAAAAAECcAABAnAAAAAAAAAAAAAAAAAAAAAAAAAAAAAAAAAAAAAAAAAAAAABQAAAAAAAAAwMD/AAAAAABkAAAAMgAAAAAAAABkAAAAAAAAAH9/fwAKAAAAIgAAABgAAAAAAAAAAAAAAAAAAAAAAAAAAAAAAAAAAAAkAAAAJAAAAAAAAAAHAAAAAAAAAAAAAAAAAAAAAAAAAAAAAAAAAAAAf39/ACUAAABYAAAAAAAAAAAAAAAAAAAAAAAAAAAAAAAAAAAAAAAAAAAAAAAAAAAAAAAAAAAAAAA/AAAAAAAAAKCGAQAAAAAAAAAAAAAAAAAMAAAAAQAAAAAAAAAAAAAAAAAAAB8AAABUAAAAAT2FAP///wEAAAAAAAAAAAAAAAAAAAAAAAAAAAAAAAAAAAAAAAAAAAAAAAJ/f38AWVlZA8zMzADAwP8Af39/AAAAAAAAAAAAAAAAAAAAAAAAAAAAIQAAABgAAAAUAAAA4AMAALMWAAAyDQAAniUAABAAAAAmAAAACAAAAP//////////"/>
               </a:ext>
             </a:extLst>
           </p:cNvSpPr>
@@ -10572,7 +10572,7 @@
             <a:spLocks noGrp="1" noChangeArrowheads="1"/>
             <a:extLst>
               <a:ext uri="smNativeData">
-                <pr:smNativeData xmlns:pr="smNativeData" xmlns="smNativeData" val="SMDATA_15_LkR5ZhMAAAAlAAAAZAAAAA0AAAAAkAAAAJAAAACQAAAAkAAAAAAAAAAAAAAAAAAAAAEAAABQAAAAAAAAAAAA4D8AAAAAAADgPwAAAAAAAOA/AAAAAAAA4D8AAAAAAADgPwAAAAAAAOA/AAAAAAAA4D8AAAAAAADgPwAAAAAAAOA/AAAAAAAA4D8CAAAAjAAAAAAAAAAAAAAAQoX0DP///wgAAAAAAAAAAAAAAAAAAAAAAAAAAAAAAAAAAAAAZAAAAAEAAABAAAAAAAAAAAAAAAAAAAAAAAAAAAAAAAAAAAAAAAAAAAAAAAAAAAAAAAAAAAAAAAAAAAAAAAAAAAAAAAAAAAAAAAAAAAAAAAAAAAAAAAAAAAAAAAAAAAAAFAAAADwAAAAAAAAAAAAAAAAAAAkUAAAAAQAAABQAAAAUAAAAFAAAAAEAAAAAAAAAZAAAAGQAAAAAAAAAZAAAAGQAAAAVAAAAYAAAAAAAAAAAAAAADwAAACADAAAAAAAAAAAAAAEAAACgMgAAVgcAAKr4//8BAAAAf39/AAEAAABkAAAAAAAAABQAAABAHwAAAAAAACYAAAAAAAAAwOD//wAAAAAmAAAAZAAAABYAAABMAAAAAAAAAAAAAAAEAAAAAAAAAAEAAABZWVkKAAAAACgAAAAoAAAAZAAAAGQAAAAAAAAAzMzMAAAAAABQAAAAUAAAAGQAAABkAAAAAAAAABcAAAAUAAAAAAAAAAAAAAD/fwAA/38AAAAAAAAJAAAABAAAAJrHIpceAAAAaAAAAAAAAAAAAAAAAAAAAAAAAAAAAAAAECcAABAnAAAAAAAAAAAAAAAAAAAAAAAAAAAAAAAAAAAAAAAAAAAAABQAAAAAAAAAwMD/AAAAAABkAAAAMgAAAAAAAABkAAAAAAAAAH9/fwAKAAAAIgAAABgAAAAAAAAAAAAAAAAAAAAAAAAAAAAAAAAAAAAkAAAAJAAAAAAAAAAHAAAAAAAAAAAAAAAAAAAAAAAAAAAAAAAAAAAAf39/ACUAAABYAAAAAAAAAAAAAAAAAAAAAAAAAAAAAAAAAAAAAAAAAAAAAAAAAAAAAAAAAAAAAAA/AAAAAAAAAKCGAQAAAAAAAAAAAAAAAAAMAAAAAQAAAAAAAAAAAAAAAAAAAB8AAABUAAAAQoX0Bf///wEAAAAAAAAAAAAAAAAAAAAAAAAAAAAAAAAAAAAAAAAAAAAAAAJ/f38AWVlZA8zMzADAwP8Af39/AAAAAAAAAAAAAAAAAAAAAAAAAAAAIQAAABgAAAAUAAAAFAMAAFQEAAB/NwAAARcAABAAAAAmAAAACAAAAD0wAAAAAAAA"/>
+                <pr:smNativeData xmlns:pr="smNativeData" xmlns="smNativeData" val="SMDATA_15_FUV5ZhMAAAAlAAAAZAAAAA0AAAAAkAAAAJAAAACQAAAAkAAAAAAAAAAAAAAAAAAAAAEAAABQAAAAAAAAAAAA4D8AAAAAAADgPwAAAAAAAOA/AAAAAAAA4D8AAAAAAADgPwAAAAAAAOA/AAAAAAAA4D8AAAAAAADgPwAAAAAAAOA/AAAAAAAA4D8CAAAAjAAAAAAAAAAAAAAAQoX0DP///wgAAAAAAAAAAAAAAAAAAAAAAAAAAAAAAAAAAAAAZAAAAAEAAABAAAAAAAAAAAAAAAAAAAAAAAAAAAAAAAAAAAAAAAAAAAAAAAAAAAAAAAAAAAAAAAAAAAAAAAAAAAAAAAAAAAAAAAAAAAAAAAAAAAAAAAAAAAAAAAAAAAAAFAAAADwAAAAAAAAAAAAAAAAAAAkUAAAAAQAAABQAAAAUAAAAFAAAAAEAAAAAAAAAZAAAAGQAAAAAAAAAZAAAAGQAAAAVAAAAYAAAAAAAAAAAAAAADwAAACADAAAAAAAAAAAAAAEAAACgMgAAVgcAAKr4//8BAAAAf39/AAEAAABkAAAAAAAAABQAAABAHwAAAAAAACYAAAAAAAAAwOD//wAAAAAmAAAAZAAAABYAAABMAAAAAAAAAAAAAAAEAAAAAAAAAAEAAABZWVkKAAAAACgAAAAoAAAAZAAAAGQAAAAAAAAAzMzMAAAAAABQAAAAUAAAAGQAAABkAAAAAAAAABcAAAAUAAAAAAAAAAAAAAD/fwAA/38AAAAAAAAJAAAABAAAAJrHIpceAAAAaAAAAAAAAAAAAAAAAAAAAAAAAAAAAAAAECcAABAnAAAAAAAAAAAAAAAAAAAAAAAAAAAAAAAAAAAAAAAAAAAAABQAAAAAAAAAwMD/AAAAAABkAAAAMgAAAAAAAABkAAAAAAAAAH9/fwAKAAAAIgAAABgAAAAAAAAAAAAAAAAAAAAAAAAAAAAAAAAAAAAkAAAAJAAAAAAAAAAHAAAAAAAAAAAAAAAAAAAAAAAAAAAAAAAAAAAAf39/ACUAAABYAAAAAAAAAAAAAAAAAAAAAAAAAAAAAAAAAAAAAAAAAAAAAAAAAAAAAAAAAAAAAAA/AAAAAAAAAKCGAQAAAAAAAAAAAAAAAAAMAAAAAQAAAAAAAAAAAAAAAAAAAB8AAABUAAAAQoX0Bf///wEAAAAAAAAAAAAAAAAAAAAAAAAAAAAAAAAAAAAAAAAAAAAAAAJ/f38AWVlZA8zMzADAwP8Af39/AAAAAAAAAAAAAAAAAAAAAAAAAAAAIQAAABgAAAAUAAAAFAMAAFQEAAB/NwAAOxQAABAAAAAmAAAACAAAAD0wAAAAAAAA"/>
               </a:ext>
             </a:extLst>
           </p:cNvSpPr>
@@ -10583,7 +10583,7 @@
         <p:spPr>
           <a:xfrm>
             <a:off x="500380" y="703580"/>
-            <a:ext cx="8521065" cy="3035935"/>
+            <a:ext cx="8521065" cy="2585085"/>
           </a:xfrm>
         </p:spPr>
         <p:txBody>
@@ -10657,7 +10657,7 @@
             <a:spLocks noGrp="1" noChangeArrowheads="1"/>
             <a:extLst>
               <a:ext uri="smNativeData">
-                <pr:smNativeData xmlns:pr="smNativeData" xmlns="smNativeData" val="SMDATA_15_LkR5ZhMAAAAlAAAAZAAAAA0AAAAAkAAAAJAAAACQAAAAkAAAAAAAAAAAAAAAAAAAAAEAAABQAAAAAAAAAAAA4D8AAAAAAADgPwAAAAAAAOA/AAAAAAAA4D8AAAAAAADgPwAAAAAAAOA/AAAAAAAA4D8AAAAAAADgPwAAAAAAAOA/AAAAAAAA4D8CAAAAjAAAAAAAAAAAAAAAQoX0DP///wgAAAAAAAAAAAAAAAAAAAAAAAAAAAAAAAAAAAAAZAAAAAEAAABAAAAAAAAAAAAAAAAAAAAAAAAAAAAAAAAAAAAAAAAAAAAAAAAAAAAAAAAAAAAAAAAAAAAAAAAAAAAAAAAAAAAAAAAAAAAAAAAAAAAAAAAAAAAAAAAAAAAAFAAAADwAAAAAAAAAAAAAAAAAAAkUAAAAAQAAABQAAAAUAAAAFAAAAAEAAAAAAAAAZAAAAGQAAAAAAAAAZAAAAGQAAAAVAAAAYAAAAAAAAAAAAAAADwAAACADAAAAAAAAAAAAAAEAAACgMgAAVgcAAKr4//8BAAAAf39/AAEAAABkAAAAAAAAABQAAABAHwAAAAAAACYAAAAAAAAAwOD//wAAAAAmAAAAZAAAABYAAABMAAAAAAAAAAAAAAAEAAAAAAAAAAEAAABZWVkKAAAAACgAAAAoAAAAZAAAAGQAAAAAAAAAzMzMAAAAAABQAAAAUAAAAGQAAABkAAAAAAAAABcAAAAUAAAAAAAAAAAAAAD/fwAA/38AAAAAAAAJAAAABAAAAMgN8V0eAAAAaAAAAAAAAAAAAAAAAAAAAAAAAAAAAAAAECcAABAnAAAAAAAAAAAAAAAAAAAAAAAAAAAAAAAAAAAAAAAAAAAAABQAAAAAAAAAwMD/AAAAAABkAAAAMgAAAAAAAABkAAAAAAAAAH9/fwAKAAAAIgAAABgAAAAAAAAAAAAAAAAAAAAAAAAAAAAAAAAAAAAkAAAAJAAAAAAAAAAHAAAAAAAAAAAAAAAAAAAAAAAAAAAAAAAAAAAAf39/ACUAAABYAAAAAAAAAAAAAAAAAAAAAAAAAAAAAAAAAAAAAAAAAAAAAAAAAAAAAAAAAAAAAAA/AAAAAAAAAKCGAQAAAAAAAAAAAAAAAAAMAAAAAQAAAAAAAAAAAAAAAAAAAB8AAABUAAAAQoX0Bf///wEAAAAAAAAAAAAAAAAAAAAAAAAAAAAAAAAAAAAAAAAAAAAAAAJ/f38AWVlZA8zMzADAwP8Af39/AAAAAAAAAAAAAAAAAAAAAAAAAAAAIQAAABgAAAAUAAAAShMAAK8ZAABQNwAAgB4AABAAAAAmAAAACAAAAD2wAAAAAAAA"/>
+                <pr:smNativeData xmlns:pr="smNativeData" xmlns="smNativeData" val="SMDATA_15_FUV5ZhMAAAAlAAAAZAAAAA0AAAAAkAAAAJAAAACQAAAAkAAAAAAAAAAAAAAAAAAAAAEAAABQAAAAAAAAAAAA4D8AAAAAAADgPwAAAAAAAOA/AAAAAAAA4D8AAAAAAADgPwAAAAAAAOA/AAAAAAAA4D8AAAAAAADgPwAAAAAAAOA/AAAAAAAA4D8CAAAAjAAAAAAAAAAAAAAAQoX0DP///wgAAAAAAAAAAAAAAAAAAAAAAAAAAAAAAAAAAAAAZAAAAAEAAABAAAAAAAAAAAAAAAAAAAAAAAAAAAAAAAAAAAAAAAAAAAAAAAAAAAAAAAAAAAAAAAAAAAAAAAAAAAAAAAAAAAAAAAAAAAAAAAAAAAAAAAAAAAAAAAAAAAAAFAAAADwAAAAAAAAAAAAAAAAAAAkUAAAAAQAAABQAAAAUAAAAFAAAAAEAAAAAAAAAZAAAAGQAAAAAAAAAZAAAAGQAAAAVAAAAYAAAAAAAAAAAAAAADwAAACADAAAAAAAAAAAAAAEAAACgMgAAVgcAAKr4//8BAAAAf39/AAEAAABkAAAAAAAAABQAAABAHwAAAAAAACYAAAAAAAAAwOD//wAAAAAmAAAAZAAAABYAAABMAAAAAAAAAAAAAAAEAAAAAAAAAAEAAABZWVkKAAAAACgAAAAoAAAAZAAAAGQAAAAAAAAAzMzMAAAAAABQAAAAUAAAAGQAAABkAAAAAAAAABcAAAAUAAAAAAAAAAAAAAD/fwAA/38AAAAAAAAJAAAABAAAAMgN8V0eAAAAaAAAAAAAAAAAAAAAAAAAAAAAAAAAAAAAECcAABAnAAAAAAAAAAAAAAAAAAAAAAAAAAAAAAAAAAAAAAAAAAAAABQAAAAAAAAAwMD/AAAAAABkAAAAMgAAAAAAAABkAAAAAAAAAH9/fwAKAAAAIgAAABgAAAAAAAAAAAAAAAAAAAAAAAAAAAAAAAAAAAAkAAAAJAAAAAAAAAAHAAAAAAAAAAAAAAAAAAAAAAAAAAAAAAAAAAAAf39/ACUAAABYAAAAAAAAAAAAAAAAAAAAAAAAAAAAAAAAAAAAAAAAAAAAAAAAAAAAAAAAAAAAAAA/AAAAAAAAAKCGAQAAAAAAAAAAAAAAAAAMAAAAAQAAAAAAAAAAAAAAAAAAAB8AAABUAAAAQoX0Bf///wEAAAAAAAAAAAAAAAAAAAAAAAAAAAAAAAAAAAAAAAAAAAAAAAJ/f38AWVlZA8zMzADAwP8Af39/AAAAAAAAAAAAAAAAAAAAAAAAAAAAIQAAABgAAAAUAAAAShMAAK8ZAABQNwAAgB4AABAAAAAmAAAACAAAAD2wAAAAAAAA"/>
               </a:ext>
             </a:extLst>
           </p:cNvSpPr>
@@ -10865,7 +10865,7 @@
             <a:spLocks noGrp="1" noChangeArrowheads="1"/>
             <a:extLst>
               <a:ext uri="smNativeData">
-                <pr:smNativeData xmlns:pr="smNativeData" xmlns="smNativeData" val="SMDATA_15_LkR5ZhMAAAAlAAAAZAAAAA0AAAAAkAAAAJAAAACQAAAAkAAAAAAAAAAAAAAAAAAAAAEAAABQAAAAAAAAAAAA4D8AAAAAAADgPwAAAAAAAOA/AAAAAAAA4D8AAAAAAADgPwAAAAAAAOA/AAAAAAAA4D8AAAAAAADgPwAAAAAAAOA/AAAAAAAA4D8CAAAAjAAAAAAAAAAAAAAAQoX0DP///wgAAAAAAAAAAAAAAAAAAAAAAAAAAAAAAAAAAAAAZAAAAAEAAABAAAAAAAAAAAAAAAAAAAAAAAAAAAAAAAAAAAAAAAAAAAAAAAAAAAAAAAAAAAAAAAAAAAAAAAAAAAAAAAAAAAAAAAAAAAAAAAAAAAAAAAAAAAAAAAAAAAAAFAAAADwAAAAAAAAAAAAAAAAAAAkUAAAAAQAAABQAAAAUAAAAFAAAAAEAAAAAAAAAZAAAAGQAAAAAAAAAZAAAAGQAAAAVAAAAYAAAAAAAAAAAAAAADwAAACADAAAAAAAAAAAAAAEAAACgMgAAVgcAAKr4//8BAAAAf39/AAEAAABkAAAAAAAAABQAAABAHwAAAAAAACYAAAAAAAAAwOD//wAAAAAmAAAAZAAAABYAAABMAAAAAAAAAAAAAAAEAAAAAAAAAAEAAABZWVkKAAAAACgAAAAoAAAAZAAAAGQAAAAAAAAAzMzMAAAAAABQAAAAUAAAAGQAAABkAAAAAAAAABcAAAAUAAAAAAAAAAAAAAD/fwAA/38AAAAAAAAJAAAABAAAAIscKB0eAAAAaAAAAAAAAAAAAAAAAAAAAAAAAAAAAAAAECcAABAnAAAAAAAAAAAAAAAAAAAAAAAAAAAAAAAAAAAAAAAAAAAAABQAAAAAAAAAwMD/AAAAAABkAAAAMgAAAAAAAABkAAAAAAAAAH9/fwAKAAAAIgAAABgAAAAAAAAAAAAAAAAAAAAAAAAAAAAAAAAAAAAkAAAAJAAAAAAAAAAHAAAAAAAAAAAAAAAAAAAAAAAAAAAAAAAAAAAAf39/ACUAAABYAAAAAAAAAAAAAAAAAAAAAAAAAAAAAAAAAAAAAAAAAAAAAAAAAAAAAAAAAAAAAAA/AAAAAAAAAKCGAQAAAAAAAAAAAAAAAAAMAAAAAQAAAAAAAAAAAAAAAAAAAB8AAABUAAAAQoX0Bf///wEAAAAAAAAAAAAAAAAAAAAAAAAAAAAAAAAAAAAAAAAAAAAAAAJ/f38AWVlZA8zMzADAwP8Af39/AAAAAAAAAAAAAAAAAAAAAAAAAAAAIQAAABgAAAAUAAAAShMAACUcAABQNwAApSIAABAAAAAmAAAACAAAAD0wAAAAAAAA"/>
+                <pr:smNativeData xmlns:pr="smNativeData" xmlns="smNativeData" val="SMDATA_15_FUV5ZhMAAAAlAAAAZAAAAA0AAAAAkAAAAJAAAACQAAAAkAAAAAAAAAAAAAAAAAAAAAEAAABQAAAAAAAAAAAA4D8AAAAAAADgPwAAAAAAAOA/AAAAAAAA4D8AAAAAAADgPwAAAAAAAOA/AAAAAAAA4D8AAAAAAADgPwAAAAAAAOA/AAAAAAAA4D8CAAAAjAAAAAAAAAAAAAAAQoX0DP///wgAAAAAAAAAAAAAAAAAAAAAAAAAAAAAAAAAAAAAZAAAAAEAAABAAAAAAAAAAAAAAAAAAAAAAAAAAAAAAAAAAAAAAAAAAAAAAAAAAAAAAAAAAAAAAAAAAAAAAAAAAAAAAAAAAAAAAAAAAAAAAAAAAAAAAAAAAAAAAAAAAAAAFAAAADwAAAAAAAAAAAAAAAAAAAkUAAAAAQAAABQAAAAUAAAAFAAAAAEAAAAAAAAAZAAAAGQAAAAAAAAAZAAAAGQAAAAVAAAAYAAAAAAAAAAAAAAADwAAACADAAAAAAAAAAAAAAEAAACgMgAAVgcAAKr4//8BAAAAf39/AAEAAABkAAAAAAAAABQAAABAHwAAAAAAACYAAAAAAAAAwOD//wAAAAAmAAAAZAAAABYAAABMAAAAAAAAAAAAAAAEAAAAAAAAAAEAAABZWVkKAAAAACgAAAAoAAAAZAAAAGQAAAAAAAAAzMzMAAAAAABQAAAAUAAAAGQAAABkAAAAAAAAABcAAAAUAAAAAAAAAAAAAAD/fwAA/38AAAAAAAAJAAAABAAAAIscKB0eAAAAaAAAAAAAAAAAAAAAAAAAAAAAAAAAAAAAECcAABAnAAAAAAAAAAAAAAAAAAAAAAAAAAAAAAAAAAAAAAAAAAAAABQAAAAAAAAAwMD/AAAAAABkAAAAMgAAAAAAAABkAAAAAAAAAH9/fwAKAAAAIgAAABgAAAAAAAAAAAAAAAAAAAAAAAAAAAAAAAAAAAAkAAAAJAAAAAAAAAAHAAAAAAAAAAAAAAAAAAAAAAAAAAAAAAAAAAAAf39/ACUAAABYAAAAAAAAAAAAAAAAAAAAAAAAAAAAAAAAAAAAAAAAAAAAAAAAAAAAAAAAAAAAAAA/AAAAAAAAAKCGAQAAAAAAAAAAAAAAAAAMAAAAAQAAAAAAAAAAAAAAAAAAAB8AAABUAAAAQoX0Bf///wEAAAAAAAAAAAAAAAAAAAAAAAAAAAAAAAAAAAAAAAAAAAAAAAJ/f38AWVlZA8zMzADAwP8Af39/AAAAAAAAAAAAAAAAAAAAAAAAAAAAIQAAABgAAAAUAAAAShMAACUcAABQNwAApSIAABAAAAAmAAAACAAAAD0wAAAAAAAA"/>
               </a:ext>
             </a:extLst>
           </p:cNvSpPr>
@@ -10911,7 +10911,7 @@
             <a:spLocks noGrp="1" noChangeArrowheads="1"/>
             <a:extLst>
               <a:ext uri="smNativeData">
-                <pr:smNativeData xmlns:pr="smNativeData" xmlns="smNativeData" val="SMDATA_15_LkR5ZhMAAAAlAAAAZAAAAA0AAAAAkAAAAJAAAACQAAAAkAAAAAAAAAAAAAAAAAAAAAEAAABQAAAAAAAAAAAA4D8AAAAAAADgPwAAAAAAAOA/AAAAAAAA4D8AAAAAAADgPwAAAAAAAOA/AAAAAAAA4D8AAAAAAADgPwAAAAAAAOA/AAAAAAAA4D8CAAAAjAAAAAAAAAAAAAAAQoX0DP///wgAAAAAAAAAAAAAAAAAAAAAAAAAAAAAAAAAAAAAZAAAAAEAAABAAAAAAAAAAAAAAAAAAAAAAAAAAAAAAAAAAAAAAAAAAAAAAAAAAAAAAAAAAAAAAAAAAAAAAAAAAAAAAAAAAAAAAAAAAAAAAAAAAAAAAAAAAAAAAAAAAAAAFAAAADwAAAAAAAAAAAAAAAAAAAkUAAAAAQAAABQAAAAUAAAAFAAAAAEAAAAAAAAAZAAAAGQAAAAAAAAAZAAAAGQAAAAVAAAAYAAAAAAAAAAAAAAADwAAACADAAAAAAAAAAAAAAEAAACgMgAAVgcAAKr4//8BAAAAf39/AAEAAABkAAAAAAAAABQAAABAHwAAAAAAACYAAAAAAAAAwOD//wAAAAAmAAAAZAAAABYAAABMAAAAAAAAAAAAAAAEAAAAAAAAAAEAAABZWVkKAAAAACgAAAAoAAAAZAAAAGQAAAAAAAAAzMzMAAAAAABQAAAAUAAAAGQAAABkAAAAAAAAABcAAAAUAAAAAAAAAAAAAAD/fwAA/38AAAAAAAAJAAAABAAAAG28P2UeAAAAaAAAAAAAAAAAAAAAAAAAAAAAAAAAAAAAECcAABAnAAAAAAAAAAAAAAAAAAAAAAAAAAAAAAAAAAAAAAAAAAAAABQAAAAAAAAAwMD/AAAAAABkAAAAMgAAAAAAAABkAAAAAAAAAH9/fwAKAAAAIgAAABgAAAAAAAAAAAAAAAAAAAAAAAAAAAAAAAAAAAAkAAAAJAAAAAAAAAAHAAAAAAAAAAAAAAAAAAAAAAAAAAAAAAAAAAAAf39/ACUAAABYAAAAAAAAAAAAAAAAAAAAAAAAAAAAAAAAAAAAAAAAAAAAAAAAAAAAAAAAAAAAAAA/AAAAAAAAAKCGAQAAAAAAAAAAAAAAAAAMAAAAAQAAAAAAAAAAAAAAAAAAAB8AAABUAAAAQoX0Bf///wEAAAAAAAAAAAAAAAAAAAAAAAAAAAAAAAAAAAAAAAAAAAAAAAJ/f38AWVlZA8zMzADAwP8Af39/AAAAAAAAAAAAAAAAAAAAAAAAAAAAIQAAABgAAAAUAAAAShMAACUdAABQNwAAniUAABAAAAAmAAAACAAAAD0wAAAAAAAA"/>
+                <pr:smNativeData xmlns:pr="smNativeData" xmlns="smNativeData" val="SMDATA_15_FUV5ZhMAAAAlAAAAZAAAAA0AAAAAkAAAAJAAAACQAAAAkAAAAAAAAAAAAAAAAAAAAAEAAABQAAAAAAAAAAAA4D8AAAAAAADgPwAAAAAAAOA/AAAAAAAA4D8AAAAAAADgPwAAAAAAAOA/AAAAAAAA4D8AAAAAAADgPwAAAAAAAOA/AAAAAAAA4D8CAAAAjAAAAAAAAAAAAAAAQoX0DP///wgAAAAAAAAAAAAAAAAAAAAAAAAAAAAAAAAAAAAAZAAAAAEAAABAAAAAAAAAAAAAAAAAAAAAAAAAAAAAAAAAAAAAAAAAAAAAAAAAAAAAAAAAAAAAAAAAAAAAAAAAAAAAAAAAAAAAAAAAAAAAAAAAAAAAAAAAAAAAAAAAAAAAFAAAADwAAAAAAAAAAAAAAAAAAAkUAAAAAQAAABQAAAAUAAAAFAAAAAEAAAAAAAAAZAAAAGQAAAAAAAAAZAAAAGQAAAAVAAAAYAAAAAAAAAAAAAAADwAAACADAAAAAAAAAAAAAAEAAACgMgAAVgcAAKr4//8BAAAAf39/AAEAAABkAAAAAAAAABQAAABAHwAAAAAAACYAAAAAAAAAwOD//wAAAAAmAAAAZAAAABYAAABMAAAAAAAAAAAAAAAEAAAAAAAAAAEAAABZWVkKAAAAACgAAAAoAAAAZAAAAGQAAAAAAAAAzMzMAAAAAABQAAAAUAAAAGQAAABkAAAAAAAAABcAAAAUAAAAAAAAAAAAAAD/fwAA/38AAAAAAAAJAAAABAAAAG28P2UeAAAAaAAAAAAAAAAAAAAAAAAAAAAAAAAAAAAAECcAABAnAAAAAAAAAAAAAAAAAAAAAAAAAAAAAAAAAAAAAAAAAAAAABQAAAAAAAAAwMD/AAAAAABkAAAAMgAAAAAAAABkAAAAAAAAAH9/fwAKAAAAIgAAABgAAAAAAAAAAAAAAAAAAAAAAAAAAAAAAAAAAAAkAAAAJAAAAAAAAAAHAAAAAAAAAAAAAAAAAAAAAAAAAAAAAAAAAAAAf39/ACUAAABYAAAAAAAAAAAAAAAAAAAAAAAAAAAAAAAAAAAAAAAAAAAAAAAAAAAAAAAAAAAAAAA/AAAAAAAAAKCGAQAAAAAAAAAAAAAAAAAMAAAAAQAAAAAAAAAAAAAAAAAAAB8AAABUAAAAQoX0Bf///wEAAAAAAAAAAAAAAAAAAAAAAAAAAAAAAAAAAAAAAAAAAAAAAAJ/f38AWVlZA8zMzADAwP8Af39/AAAAAAAAAAAAAAAAAAAAAAAAAAAAIQAAABgAAAAUAAAAShMAACUdAABQNwAAniUAABAAAAAmAAAACAAAAD0wAAAAAAAA"/>
               </a:ext>
             </a:extLst>
           </p:cNvSpPr>
@@ -10979,7 +10979,7 @@
             <a:picLocks noChangeAspect="1"/>
             <a:extLst>
               <a:ext uri="smNativeData">
-                <pr:smNativeData xmlns:pr="smNativeData" xmlns="smNativeData" val="SMDATA_17_LkR5ZhMAAAAlAAAAEQAAAC8BAAAAkAAAAEgAAACQAAAASAAAAAAAAAAAAAAAAAAAAAEAAABQAAAAAAAAAAAA4D8AAAAAAADgPwAAAAAAAOA/AAAAAAAA4D8AAAAAAADgPwAAAAAAAOA/AAAAAAAA4D8AAAAAAADgPwAAAAAAAOA/AAAAAAAA4D8CAAAAjAAAAAAAAAAAAAAAQoX0DP///wgAAAAAAAAAAAAAAAAAAAAAAAAAAAAAAAAAAAAAZAAAAAEAAABAAAAAAAAAAAAAAAAAAAAAAAAAAAAAAAAAAAAAAAAAAAAAAAAAAAAAAAAAAAAAAAAAAAAAAAAAAAAAAAAAAAAAAAAAAAAAAAAAAAAAAAAAAAAAAAAAAAAAFAAAADwAAAAAAAAAAAAAAAAAAAkUAAAAAQAAABQAAAAUAAAAFAAAAAEAAAAAAAAAZAAAAGQAAAAAAAAAZAAAAGQAAAAVAAAAYAAAAAAAAAAAAAAADwAAACADAAAAAAAAAAAAAAEAAACgMgAAVgcAAKr4//8BAAAAf39/AAEAAABkAAAAAAAAABQAAABAHwAAAAAAACYAAAAAAAAAwOD//wAAAAAmAAAAZAAAABYAAABMAAAAAAAAAAAAAAAEAAAAAAAAAAEAAABZWVkKAAAAACgAAAAoAAAAZAAAAGQAAAAAAAAAzMzMAAAAAABQAAAAUAAAAGQAAABkAAAAAAAAAAcAAAA4AAAAAAAAAAAAAAAAAAAA////AAAAAAAAAAAAAAAAAAAAAAAAAAAAAAAAAAAAAABkAAAAZAAAAAAAAAAjAAAABAAAAGQAAAAXAAAAFAAAAAAAAAAAAAAA/38AAP9/AAAAAAAACQAAAAQAAAAAAAAAHgAAAGgAAAAAAAAAAAAAAAAAAAAAAAAAAAAAABAnAAAQJwAAAAAAAAAAAAAAAAAAAAAAAAAAAAAAAAAAAAAAAAAAAAAUAAAAAAAAAMDA/wAAAAAAZAAAADIAAAAAAAAAZAAAAAAAAAB/f38ACgAAACIAAAAYAAAAAAAAAAAAAAAAAAAAAAAAAAAAAAAAAAAAJAAAACQAAAAAAAAABwAAAAAAAAAAAAAAAAAAAAAAAAAAAAAAAAAAAH9/fwAlAAAAWAAAAAAAAAAAAAAAAAAAAAAAAAAAAAAAAAAAAAAAAAAAAAAAAAAAAAAAAAAAAAAAPwAAAAAAAACghgEAAAAAAAAAAAAAAAAADAAAAAEAAAAAAAAAAAAAAAAAAAAfAAAAVAAAAEKF9AX///8BAAAAAAAAAAAAAAAAAAAAAAAAAAAAAAAAAAAAAAAAAAAAAAACf39/AFlZWQPMzMwAwMD/AH9/fwAAAAAAAAAAAAAAAAD///8AAAAAACEAAAAYAAAAFAAAAHgEAACpGAAA0Q4AAL8lAAAQAAAAJgAAAAgAAAD//////////w=="/>
+                <pr:smNativeData xmlns:pr="smNativeData" xmlns="smNativeData" val="SMDATA_17_FUV5ZhMAAAAlAAAAEQAAAC8BAAAAkAAAAEgAAACQAAAASAAAAAAAAAAAAAAAAAAAAAEAAABQAAAAAAAAAAAA4D8AAAAAAADgPwAAAAAAAOA/AAAAAAAA4D8AAAAAAADgPwAAAAAAAOA/AAAAAAAA4D8AAAAAAADgPwAAAAAAAOA/AAAAAAAA4D8CAAAAjAAAAAAAAAAAAAAAQoX0DP///wgAAAAAAAAAAAAAAAAAAAAAAAAAAAAAAAAAAAAAZAAAAAEAAABAAAAAAAAAAAAAAAAAAAAAAAAAAAAAAAAAAAAAAAAAAAAAAAAAAAAAAAAAAAAAAAAAAAAAAAAAAAAAAAAAAAAAAAAAAAAAAAAAAAAAAAAAAAAAAAAAAAAAFAAAADwAAAAAAAAAAAAAAAAAAAkUAAAAAQAAABQAAAAUAAAAFAAAAAEAAAAAAAAAZAAAAGQAAAAAAAAAZAAAAGQAAAAVAAAAYAAAAAAAAAAAAAAADwAAACADAAAAAAAAAAAAAAEAAACgMgAAVgcAAKr4//8BAAAAf39/AAEAAABkAAAAAAAAABQAAABAHwAAAAAAACYAAAAAAAAAwOD//wAAAAAmAAAAZAAAABYAAABMAAAAAAAAAAAAAAAEAAAAAAAAAAEAAABZWVkKAAAAACgAAAAoAAAAZAAAAGQAAAAAAAAAzMzMAAAAAABQAAAAUAAAAGQAAABkAAAAAAAAAAcAAAA4AAAAAAAAAAAAAAAAAAAA////AAAAAAAAAAAAAAAAAAAAAAAAAAAAAAAAAAAAAABkAAAAZAAAAAAAAAAjAAAABAAAAGQAAAAXAAAAFAAAAAAAAAAAAAAA/38AAP9/AAAAAAAACQAAAAQAAAAAAAAAHgAAAGgAAAAAAAAAAAAAAAAAAAAAAAAAAAAAABAnAAAQJwAAAAAAAAAAAAAAAAAAAAAAAAAAAAAAAAAAAAAAAAAAAAAUAAAAAAAAAMDA/wAAAAAAZAAAADIAAAAAAAAAZAAAAAAAAAB/f38ACgAAACIAAAAYAAAAAAAAAAAAAAAAAAAAAAAAAAAAAAAAAAAAJAAAACQAAAAAAAAABwAAAAAAAAAAAAAAAAAAAAAAAAAAAAAAAAAAAH9/fwAlAAAAWAAAAAAAAAAAAAAAAAAAAAAAAAAAAAAAAAAAAAAAAAAAAAAAAAAAAAAAAAAAAAAAPwAAAAAAAACghgEAAAAAAAAAAAAAAAAADAAAAAEAAAAAAAAAAAAAAAAAAAAfAAAAVAAAAEKF9AX///8BAAAAAAAAAAAAAAAAAAAAAAAAAAAAAAAAAAAAAAAAAAAAAAACf39/AFlZWQPMzMwAwMD/AH9/fwAAAAAAAAAAAAAAAAD///8AAAAAACEAAAAYAAAAFAAAAHgEAACpGAAA0Q4AAL8lAAAQAAAAJgAAAAgAAAD//////////w=="/>
               </a:ext>
             </a:extLst>
           </p:cNvPicPr>
@@ -11045,7 +11045,7 @@
             <a:spLocks noGrp="1" noChangeArrowheads="1"/>
             <a:extLst>
               <a:ext uri="smNativeData">
-                <pr:smNativeData xmlns:pr="smNativeData" xmlns="smNativeData" val="SMDATA_15_LkR5ZhMAAAAlAAAAZAAAAA0AAAAAkAAAAJAAAACQAAAAkAAAAAAAAAAAAAAAAAAAAAEAAABQAAAAAAAAAAAA4D8AAAAAAADgPwAAAAAAAOA/AAAAAAAA4D8AAAAAAADgPwAAAAAAAOA/AAAAAAAA4D8AAAAAAADgPwAAAAAAAOA/AAAAAAAA4D8CAAAAjAAAAAAAAAAAAAAAQoX0DP///wgAAAAAAAAAAAAAAAAAAAAAAAAAAAAAAAAAAAAAZAAAAAEAAABAAAAAAAAAAAAAAAAAAAAAAAAAAAAAAAAAAAAAAAAAAAAAAAAAAAAAAAAAAAAAAAAAAAAAAAAAAAAAAAAAAAAAAAAAAAAAAAAAAAAAAAAAAAAAAAAAAAAAFAAAADwAAAAAAAAAAAAAAAAAAAkUAAAAAQAAABQAAAAUAAAAFAAAAAEAAAAAAAAAZAAAAGQAAAAAAAAAZAAAAGQAAAAVAAAAYAAAAAAAAAAAAAAADwAAACADAAAAAAAAAAAAAAEAAACgMgAAVgcAAKr4//8BAAAAf39/AAEAAABkAAAAAAAAABQAAABAHwAAAAAAACYAAAAAAAAAwOD//wAAAAAmAAAAZAAAABYAAABMAAAAAAAAAAAAAAAEAAAAAAAAAAEAAABZWVkKAAAAACgAAAAoAAAAZAAAAGQAAAAAAAAAzMzMAAAAAABQAAAAUAAAAGQAAABkAAAAAAAAABcAAAAUAAAAAAAAAAAAAAD/fwAA/38AAAAAAAAJAAAABAAAAF8AYAAeAAAAaAAAAAAAAAAAAAAAAAAAAAAAAAAAAAAAECcAABAnAAAAAAAAAAAAAAAAAAAAAAAAAAAAAAAAAAAAAAAAAAAAABQAAAAAAAAAwMD/AAAAAABkAAAAMgAAAAAAAABkAAAAAAAAAH9/fwAKAAAAIgAAABgAAAAAAAAAAAAAAAAAAAAAAAAAAAAAAAAAAAAkAAAAJAAAAAAAAAAHAAAAAAAAAAAAAAAAAAAAAAAAAAAAAAAAAAAAf39/ACUAAABYAAAAAAAAAAAAAAAAAAAAAAAAAAAAAAAAAAAAAAAAAAAAAAAAAAAAAAAAAAAAAAA/AAAAAAAAAKCGAQAAAAAAAAAAAAAAAAAMAAAAAQAAAAAAAAAAAAAAAAAAAB8AAABUAAAAQoX0Bf///wEAAAAAAAAAAAAAAAAAAAAAAAAAAAAAAAAAAAAAAAAAAAAAAAJ/f38AWVlZA8zMzADAwP8Af39/AAAAAAAAAAAAAAAAAAAAAAAAAAAAIQAAABgAAAAUAAAAFAMAALYCAAB/NwAAVAcAABAAAAAmAAAACAAAAD0wAAAAAAAA"/>
+                <pr:smNativeData xmlns:pr="smNativeData" xmlns="smNativeData" val="SMDATA_15_FUV5ZhMAAAAlAAAAZAAAAA0AAAAAkAAAAJAAAACQAAAAkAAAAAAAAAAAAAAAAAAAAAEAAABQAAAAAAAAAAAA4D8AAAAAAADgPwAAAAAAAOA/AAAAAAAA4D8AAAAAAADgPwAAAAAAAOA/AAAAAAAA4D8AAAAAAADgPwAAAAAAAOA/AAAAAAAA4D8CAAAAjAAAAAAAAAAAAAAAQoX0DP///wgAAAAAAAAAAAAAAAAAAAAAAAAAAAAAAAAAAAAAZAAAAAEAAABAAAAAAAAAAAAAAAAAAAAAAAAAAAAAAAAAAAAAAAAAAAAAAAAAAAAAAAAAAAAAAAAAAAAAAAAAAAAAAAAAAAAAAAAAAAAAAAAAAAAAAAAAAAAAAAAAAAAAFAAAADwAAAAAAAAAAAAAAAAAAAkUAAAAAQAAABQAAAAUAAAAFAAAAAEAAAAAAAAAZAAAAGQAAAAAAAAAZAAAAGQAAAAVAAAAYAAAAAAAAAAAAAAADwAAACADAAAAAAAAAAAAAAEAAACgMgAAVgcAAKr4//8BAAAAf39/AAEAAABkAAAAAAAAABQAAABAHwAAAAAAACYAAAAAAAAAwOD//wAAAAAmAAAAZAAAABYAAABMAAAAAAAAAAAAAAAEAAAAAAAAAAEAAABZWVkKAAAAACgAAAAoAAAAZAAAAGQAAAAAAAAAzMzMAAAAAABQAAAAUAAAAGQAAABkAAAAAAAAABcAAAAUAAAAAAAAAAAAAAD/fwAA/38AAAAAAAAJAAAABAAAAF8AYAAeAAAAaAAAAAAAAAAAAAAAAAAAAAAAAAAAAAAAECcAABAnAAAAAAAAAAAAAAAAAAAAAAAAAAAAAAAAAAAAAAAAAAAAABQAAAAAAAAAwMD/AAAAAABkAAAAMgAAAAAAAABkAAAAAAAAAH9/fwAKAAAAIgAAABgAAAAAAAAAAAAAAAAAAAAAAAAAAAAAAAAAAAAkAAAAJAAAAAAAAAAHAAAAAAAAAAAAAAAAAAAAAAAAAAAAAAAAAAAAf39/ACUAAABYAAAAAAAAAAAAAAAAAAAAAAAAAAAAAAAAAAAAAAAAAAAAAAAAAAAAAAAAAAAAAAA/AAAAAAAAAKCGAQAAAAAAAAAAAAAAAAAMAAAAAQAAAAAAAAAAAAAAAAAAAB8AAABUAAAAQoX0Bf///wEAAAAAAAAAAAAAAAAAAAAAAAAAAAAAAAAAAAAAAAAAAAAAAAJ/f38AWVlZA8zMzADAwP8Af39/AAAAAAAAAAAAAAAAAAAAAAAAAAAAIQAAABgAAAAUAAAAFAMAALYCAAB/NwAAVAcAABAAAAAmAAAACAAAAD0wAAAAAAAA"/>
               </a:ext>
             </a:extLst>
           </p:cNvSpPr>
@@ -11090,7 +11090,7 @@
           <p:cNvSpPr>
             <a:extLst>
               <a:ext uri="smNativeData">
-                <pr:smNativeData xmlns:pr="smNativeData" xmlns="smNativeData" val="SMDATA_15_LkR5ZhMAAAAlAAAAZQAAAA0AAAAAqQEAAJAAAACpAQAAkAAAAAAAAAABAAAAAAAAAAEAAABQAAAAhbacS3FV1T8AAAAAAAAAAAAAAAAAAOA/AAAAAAAA4D8AAAAAAADgPwAAAAAAAOA/AAAAAAAA4D8AAAAAAADgPwAAAAAAAOA/AAAAAAAA4D8CAAAAjAAAAAEAAAAAAAAAi47jAP///wgAAAAAAAAAAAAAAAAAAAAAAAAAAAAAAAAAAAAAeAAAAAEAAABAAAAAAAAAAAAAAABaAAAAAAAAAAAAAAAAAAAAAAAAAAAAAAAAAAAAAAAAAAAAAAAAAAAAAAAAAAAAAAAAAAAAAAAAAAAAAAAAAAAAAAAAAAAAAAAAAAAAFAAAADwAAAAAAAAAAAAAAAAAAAkUAAAAAQAAABQAAAAUAAAAFAAAAAEAAAAAAAAAZAAAAGQAAAAAAAAAZAAAAGQAAAAVAAAAYAAAAAAAAAAAAAAADwAAACADAAAAAAAAAAAAAAEAAACgMgAAVgcAAKr4//8BAAAAf39/AAEAAABkAAAAAAAAABQAAABAHwAAAAAAACYAAAAAAAAAwOD//wAAAAAmAAAAZAAAABYAAABMAAAAAAAAAAAAAAAEAAAAAAAAAAEAAABZWVkKAAAAACgAAAAoAAAAZAAAAGQAAAAAAAAAzMzMAAAAAABQAAAAUAAAAGQAAABkAAAAAAAAABcAAAAUAAAAAAAAAAAAAAD/fwAA/38AAAAAAAAJAAAABAAAAEqKdAoeAAAAaAAAAAAAAAAAAAAAAAAAAAAAAAAAAAAAECcAABAnAAAAAAAAAAAAAAAAAAAAAAAAAAAAAAAAAAAAAAAAAAAAABQAAAAAAAAAwMD/AAAAAABkAAAAMgAAAAAAAABkAAAAAAAAAH9/fwAKAAAAIgAAABgAAAAAAAAAAAAAAAAAAAAAAAAAAAAAAAAAAAAkAAAAJAAAAAAAAAAHAAAAAAAAAAAAAAAAAAAAAAAAAAAAAAAAAAAAf39/ACUAAABYAAAAAAAAAAAAAAAAAAAAAAAAAAAAAAAAAAAAAAAAAAAAAAAAAAAAAAAAAAAAAAA/AAAAAAAAAKCGAQAAAAAAAAAAAAAAAAAMAAAAAQAAAAAAAAAAAAAAAAAAAB8AAABUAAAAi47jAP///wEAAAAAAAAAAAAAAAAAAAAAAAAAAAAAAAAAAAAAAAAAAAAAAAJ/f38AWVlZA8zMzADAwP8Af39/AAAAAAAAAAAAAAAAAAAAAAAAAAAAIQAAABgAAAAUAAAAMAQAAM0IAAADGQAA4wsAABAAAAAmAAAACAAAAP//////////"/>
+                <pr:smNativeData xmlns:pr="smNativeData" xmlns="smNativeData" val="SMDATA_15_FUV5ZhMAAAAlAAAAZQAAAA0AAAAAqQEAAJAAAACpAQAAkAAAAAAAAAABAAAAAAAAAAEAAABQAAAAhbacS3FV1T8AAAAAAAAAAAAAAAAAAOA/AAAAAAAA4D8AAAAAAADgPwAAAAAAAOA/AAAAAAAA4D8AAAAAAADgPwAAAAAAAOA/AAAAAAAA4D8CAAAAjAAAAAEAAAAAAAAAi47jAP///wgAAAAAAAAAAAAAAAAAAAAAAAAAAAAAAAAAAAAAeAAAAAEAAABAAAAAAAAAAAAAAABaAAAAAAAAAAAAAAAAAAAAAAAAAAAAAAAAAAAAAAAAAAAAAAAAAAAAAAAAAAAAAAAAAAAAAAAAAAAAAAAAAAAAAAAAAAAAAAAAAAAAFAAAADwAAAAAAAAAAAAAAAAAAAkUAAAAAQAAABQAAAAUAAAAFAAAAAEAAAAAAAAAZAAAAGQAAAAAAAAAZAAAAGQAAAAVAAAAYAAAAAAAAAAAAAAADwAAACADAAAAAAAAAAAAAAEAAACgMgAAVgcAAKr4//8BAAAAf39/AAEAAABkAAAAAAAAABQAAABAHwAAAAAAACYAAAAAAAAAwOD//wAAAAAmAAAAZAAAABYAAABMAAAAAAAAAAAAAAAEAAAAAAAAAAEAAABZWVkKAAAAACgAAAAoAAAAZAAAAGQAAAAAAAAAzMzMAAAAAABQAAAAUAAAAGQAAABkAAAAAAAAABcAAAAUAAAAAAAAAAAAAAD/fwAA/38AAAAAAAAJAAAABAAAAEqKdAoeAAAAaAAAAAAAAAAAAAAAAAAAAAAAAAAAAAAAECcAABAnAAAAAAAAAAAAAAAAAAAAAAAAAAAAAAAAAAAAAAAAAAAAABQAAAAAAAAAwMD/AAAAAABkAAAAMgAAAAAAAABkAAAAAAAAAH9/fwAKAAAAIgAAABgAAAAAAAAAAAAAAAAAAAAAAAAAAAAAAAAAAAAkAAAAJAAAAAAAAAAHAAAAAAAAAAAAAAAAAAAAAAAAAAAAAAAAAAAAf39/ACUAAABYAAAAAAAAAAAAAAAAAAAAAAAAAAAAAAAAAAAAAAAAAAAAAAAAAAAAAAAAAAAAAAA/AAAAAAAAAKCGAQAAAAAAAAAAAAAAAAAMAAAAAQAAAAAAAAAAAAAAAAAAAB8AAABUAAAAi47jAP///wEAAAAAAAAAAAAAAAAAAAAAAAAAAAAAAAAAAAAAAAAAAAAAAAJ/f38AWVlZA8zMzADAwP8Af39/AAAAAAAAAAAAAAAAAAAAAAAAAAAAIQAAABgAAAAUAAAAMAQAAM0IAAADGQAA4wsAABAAAAAmAAAACAAAAP//////////"/>
               </a:ext>
             </a:extLst>
           </p:cNvSpPr>
@@ -11155,7 +11155,7 @@
           <p:cNvSpPr>
             <a:extLst>
               <a:ext uri="smNativeData">
-                <pr:smNativeData xmlns:pr="smNativeData" xmlns="smNativeData" val="SMDATA_15_LkR5ZhMAAAAlAAAAZQAAAA0AAAAAqQEAAJAAAACpAQAAkAAAAAAAAAABAAAAAAAAAAEAAABQAAAAhbacS3FV1T8AAAAAAAAAAAAAAAAAAOA/AAAAAAAA4D8AAAAAAADgPwAAAAAAAOA/AAAAAAAA4D8AAAAAAADgPwAAAAAAAOA/AAAAAAAA4D8CAAAAjAAAAAEAAAAAAAAAi47jAP///wgAAAAAAAAAAAAAAAAAAAAAAAAAAAAAAAAAAAAAeAAAAAEAAABAAAAAAAAAAAAAAABaAAAAAAAAAAAAAAAAAAAAAAAAAAAAAAAAAAAAAAAAAAAAAAAAAAAAAAAAAAAAAAAAAAAAAAAAAAAAAAAAAAAAAAAAAAAAAAAAAAAAFAAAADwAAAAAAAAAAAAAAAAAAAkUAAAAAQAAABQAAAAUAAAAFAAAAAEAAAAAAAAAZAAAAGQAAAAAAAAAZAAAAGQAAAAVAAAAYAAAAAAAAAAAAAAADwAAACADAAAAAAAAAAAAAAEAAACgMgAAVgcAAKr4//8BAAAAf39/AAEAAABkAAAAAAAAABQAAABAHwAAAAAAACYAAAAAAAAAwOD//wAAAAAmAAAAZAAAABYAAABMAAAAAAAAAAAAAAAEAAAAAAAAAAEAAABZWVkKAAAAACgAAAAoAAAAZAAAAGQAAAAAAAAAzMzMAAAAAABQAAAAUAAAAGQAAABkAAAAAAAAABcAAAAUAAAAAAAAAAAAAAD/fwAA/38AAAAAAAAJAAAABAAAAMdydoweAAAAaAAAAAAAAAAAAAAAAAAAAAAAAAAAAAAAECcAABAnAAAAAAAAAAAAAAAAAAAAAAAAAAAAAAAAAAAAAAAAAAAAABQAAAAAAAAAwMD/AAAAAABkAAAAMgAAAAAAAABkAAAAAAAAAH9/fwAKAAAAIgAAABgAAAAAAAAAAAAAAAAAAAAAAAAAAAAAAAAAAAAkAAAAJAAAAAAAAAAHAAAAAAAAAAAAAAAAAAAAAAAAAAAAAAAAAAAAf39/ACUAAABYAAAAAAAAAAAAAAAAAAAAAAAAAAAAAAAAAAAAAAAAAAAAAAAAAAAAAAAAAAAAAAA/AAAAAAAAAKCGAQAAAAAAAAAAAAAAAAAMAAAAAQAAAAAAAAAAAAAAAAAAAB8AAABUAAAAi47jAP///wEAAAAAAAAAAAAAAAAAAAAAAAAAAAAAAAAAAAAAAAAAAAAAAAJ/f38AWVlZA8zMzADAwP8Af39/AAAAAAAAAAAAAAAAAAAAAAAAAAAAIQAAABgAAAAUAAAAMAQAAN4NAAADGQAA9BAAABAAAAAmAAAACAAAAP//////////"/>
+                <pr:smNativeData xmlns:pr="smNativeData" xmlns="smNativeData" val="SMDATA_15_FUV5ZhMAAAAlAAAAZQAAAA0AAAAAqQEAAJAAAACpAQAAkAAAAAAAAAABAAAAAAAAAAEAAABQAAAAhbacS3FV1T8AAAAAAAAAAAAAAAAAAOA/AAAAAAAA4D8AAAAAAADgPwAAAAAAAOA/AAAAAAAA4D8AAAAAAADgPwAAAAAAAOA/AAAAAAAA4D8CAAAAjAAAAAEAAAAAAAAAi47jAP///wgAAAAAAAAAAAAAAAAAAAAAAAAAAAAAAAAAAAAAeAAAAAEAAABAAAAAAAAAAAAAAABaAAAAAAAAAAAAAAAAAAAAAAAAAAAAAAAAAAAAAAAAAAAAAAAAAAAAAAAAAAAAAAAAAAAAAAAAAAAAAAAAAAAAAAAAAAAAAAAAAAAAFAAAADwAAAAAAAAAAAAAAAAAAAkUAAAAAQAAABQAAAAUAAAAFAAAAAEAAAAAAAAAZAAAAGQAAAAAAAAAZAAAAGQAAAAVAAAAYAAAAAAAAAAAAAAADwAAACADAAAAAAAAAAAAAAEAAACgMgAAVgcAAKr4//8BAAAAf39/AAEAAABkAAAAAAAAABQAAABAHwAAAAAAACYAAAAAAAAAwOD//wAAAAAmAAAAZAAAABYAAABMAAAAAAAAAAAAAAAEAAAAAAAAAAEAAABZWVkKAAAAACgAAAAoAAAAZAAAAGQAAAAAAAAAzMzMAAAAAABQAAAAUAAAAGQAAABkAAAAAAAAABcAAAAUAAAAAAAAAAAAAAD/fwAA/38AAAAAAAAJAAAABAAAAMdydoweAAAAaAAAAAAAAAAAAAAAAAAAAAAAAAAAAAAAECcAABAnAAAAAAAAAAAAAAAAAAAAAAAAAAAAAAAAAAAAAAAAAAAAABQAAAAAAAAAwMD/AAAAAABkAAAAMgAAAAAAAABkAAAAAAAAAH9/fwAKAAAAIgAAABgAAAAAAAAAAAAAAAAAAAAAAAAAAAAAAAAAAAAkAAAAJAAAAAAAAAAHAAAAAAAAAAAAAAAAAAAAAAAAAAAAAAAAAAAAf39/ACUAAABYAAAAAAAAAAAAAAAAAAAAAAAAAAAAAAAAAAAAAAAAAAAAAAAAAAAAAAAAAAAAAAA/AAAAAAAAAKCGAQAAAAAAAAAAAAAAAAAMAAAAAQAAAAAAAAAAAAAAAAAAAB8AAABUAAAAi47jAP///wEAAAAAAAAAAAAAAAAAAAAAAAAAAAAAAAAAAAAAAAAAAAAAAAJ/f38AWVlZA8zMzADAwP8Af39/AAAAAAAAAAAAAAAAAAAAAAAAAAAAIQAAABgAAAAUAAAAMAQAAN4NAAADGQAA9BAAABAAAAAmAAAACAAAAP//////////"/>
               </a:ext>
             </a:extLst>
           </p:cNvSpPr>
@@ -11220,7 +11220,7 @@
           <p:cNvSpPr>
             <a:extLst>
               <a:ext uri="smNativeData">
-                <pr:smNativeData xmlns:pr="smNativeData" xmlns="smNativeData" val="SMDATA_15_LkR5ZhMAAAAlAAAAZQAAAA0AAAAAqQEAAJAAAACpAQAAkAAAAAAAAAABAAAAAAAAAAEAAABQAAAAhbacS3FV1T8AAAAAAAAAAAAAAAAAAOA/AAAAAAAA4D8AAAAAAADgPwAAAAAAAOA/AAAAAAAA4D8AAAAAAADgPwAAAAAAAOA/AAAAAAAA4D8CAAAAjAAAAAEAAAAAAAAAi47jAP///wgAAAAAAAAAAAAAAAAAAAAAAAAAAAAAAAAAAAAAeAAAAAEAAABAAAAAAAAAAAAAAABaAAAAAAAAAAAAAAAAAAAAAAAAAAAAAAAAAAAAAAAAAAAAAAAAAAAAAAAAAAAAAAAAAAAAAAAAAAAAAAAAAAAAAAAAAAAAAAAAAAAAFAAAADwAAAAAAAAAAAAAAAAAAAkUAAAAAQAAABQAAAAUAAAAFAAAAAEAAAAAAAAAZAAAAGQAAAAAAAAAZAAAAGQAAAAVAAAAYAAAAAAAAAAAAAAADwAAACADAAAAAAAAAAAAAAEAAACgMgAAVgcAAKr4//8BAAAAf39/AAEAAABkAAAAAAAAABQAAABAHwAAAAAAACYAAAAAAAAAwOD//wAAAAAmAAAAZAAAABYAAABMAAAAAAAAAAAAAAAEAAAAAAAAAAEAAABZWVkKAAAAACgAAAAoAAAAZAAAAGQAAAAAAAAAzMzMAAAAAABQAAAAUAAAAGQAAABkAAAAAAAAABcAAAAUAAAAAAAAAAAAAAD/fwAA/38AAAAAAAAJAAAABAAAAE554FYeAAAAaAAAAAAAAAAAAAAAAAAAAAAAAAAAAAAAECcAABAnAAAAAAAAAAAAAAAAAAAAAAAAAAAAAAAAAAAAAAAAAAAAABQAAAAAAAAAwMD/AAAAAABkAAAAMgAAAAAAAABkAAAAAAAAAH9/fwAKAAAAIgAAABgAAAAAAAAAAAAAAAAAAAAAAAAAAAAAAAAAAAAkAAAAJAAAAAAAAAAHAAAAAAAAAAAAAAAAAAAAAAAAAAAAAAAAAAAAf39/ACUAAABYAAAAAAAAAAAAAAAAAAAAAAAAAAAAAAAAAAAAAAAAAAAAAAAAAAAAAAAAAAAAAAA/AAAAAAAAAKCGAQAAAAAAAAAAAAAAAAAMAAAAAQAAAAAAAAAAAAAAAAAAAB8AAABUAAAAi47jAP///wEAAAAAAAAAAAAAAAAAAAAAAAAAAAAAAAAAAAAAAAAAAAAAAAJ/f38AWVlZA8zMzADAwP8Af39/AAAAAAAAAAAAAAAAAAAAAAAAAAAAIQAAABgAAAAUAAAAMAQAAAQTAAADGQAAGhYAABAAAAAmAAAACAAAAP//////////"/>
+                <pr:smNativeData xmlns:pr="smNativeData" xmlns="smNativeData" val="SMDATA_15_FUV5ZhMAAAAlAAAAZQAAAA0AAAAAqQEAAJAAAACpAQAAkAAAAAAAAAABAAAAAAAAAAEAAABQAAAAhbacS3FV1T8AAAAAAAAAAAAAAAAAAOA/AAAAAAAA4D8AAAAAAADgPwAAAAAAAOA/AAAAAAAA4D8AAAAAAADgPwAAAAAAAOA/AAAAAAAA4D8CAAAAjAAAAAEAAAAAAAAAi47jAP///wgAAAAAAAAAAAAAAAAAAAAAAAAAAAAAAAAAAAAAeAAAAAEAAABAAAAAAAAAAAAAAABaAAAAAAAAAAAAAAAAAAAAAAAAAAAAAAAAAAAAAAAAAAAAAAAAAAAAAAAAAAAAAAAAAAAAAAAAAAAAAAAAAAAAAAAAAAAAAAAAAAAAFAAAADwAAAAAAAAAAAAAAAAAAAkUAAAAAQAAABQAAAAUAAAAFAAAAAEAAAAAAAAAZAAAAGQAAAAAAAAAZAAAAGQAAAAVAAAAYAAAAAAAAAAAAAAADwAAACADAAAAAAAAAAAAAAEAAACgMgAAVgcAAKr4//8BAAAAf39/AAEAAABkAAAAAAAAABQAAABAHwAAAAAAACYAAAAAAAAAwOD//wAAAAAmAAAAZAAAABYAAABMAAAAAAAAAAAAAAAEAAAAAAAAAAEAAABZWVkKAAAAACgAAAAoAAAAZAAAAGQAAAAAAAAAzMzMAAAAAABQAAAAUAAAAGQAAABkAAAAAAAAABcAAAAUAAAAAAAAAAAAAAD/fwAA/38AAAAAAAAJAAAABAAAAE554FYeAAAAaAAAAAAAAAAAAAAAAAAAAAAAAAAAAAAAECcAABAnAAAAAAAAAAAAAAAAAAAAAAAAAAAAAAAAAAAAAAAAAAAAABQAAAAAAAAAwMD/AAAAAABkAAAAMgAAAAAAAABkAAAAAAAAAH9/fwAKAAAAIgAAABgAAAAAAAAAAAAAAAAAAAAAAAAAAAAAAAAAAAAkAAAAJAAAAAAAAAAHAAAAAAAAAAAAAAAAAAAAAAAAAAAAAAAAAAAAf39/ACUAAABYAAAAAAAAAAAAAAAAAAAAAAAAAAAAAAAAAAAAAAAAAAAAAAAAAAAAAAAAAAAAAAA/AAAAAAAAAKCGAQAAAAAAAAAAAAAAAAAMAAAAAQAAAAAAAAAAAAAAAAAAAB8AAABUAAAAi47jAP///wEAAAAAAAAAAAAAAAAAAAAAAAAAAAAAAAAAAAAAAAAAAAAAAAJ/f38AWVlZA8zMzADAwP8Af39/AAAAAAAAAAAAAAAAAAAAAAAAAAAAIQAAABgAAAAUAAAAMAQAAAQTAAADGQAAGhYAABAAAAAmAAAACAAAAP//////////"/>
               </a:ext>
             </a:extLst>
           </p:cNvSpPr>
@@ -11285,7 +11285,7 @@
           <p:cNvSpPr>
             <a:extLst>
               <a:ext uri="smNativeData">
-                <pr:smNativeData xmlns:pr="smNativeData" xmlns="smNativeData" val="SMDATA_15_LkR5ZhMAAAAlAAAAZQAAAA0AAAAAqQEAAJAAAACpAQAAkAAAAAAAAAABAAAAAAAAAAEAAABQAAAAhbacS3FV1T8AAAAAAAAAAAAAAAAAAOA/AAAAAAAA4D8AAAAAAADgPwAAAAAAAOA/AAAAAAAA4D8AAAAAAADgPwAAAAAAAOA/AAAAAAAA4D8CAAAAjAAAAAEAAAAAAAAAi47jAP///wgAAAAAAAAAAAAAAAAAAAAAAAAAAAAAAAAAAAAAeAAAAAEAAABAAAAAAAAAAAAAAABaAAAAAAAAAAAAAAAAAAAAAAAAAAAAAAAAAAAAAAAAAAAAAAAAAAAAAAAAAAAAAAAAAAAAAAAAAAAAAAAAAAAAAAAAAAAAAAAAAAAAFAAAADwAAAAAAAAAAAAAAAAAAAkUAAAAAQAAABQAAAAUAAAAFAAAAAEAAAAAAAAAZAAAAGQAAAAAAAAAZAAAAGQAAAAVAAAAYAAAAAAAAAAAAAAADwAAACADAAAAAAAAAAAAAAEAAACgMgAAVgcAAKr4//8BAAAAf39/AAEAAABkAAAAAAAAABQAAABAHwAAAAAAACYAAAAAAAAAwOD//wAAAAAmAAAAZAAAABYAAABMAAAAAAAAAAAAAAAEAAAAAAAAAAEAAABZWVkKAAAAACgAAAAoAAAAZAAAAGQAAAAAAAAAzMzMAAAAAABQAAAAUAAAAGQAAABkAAAAAAAAABcAAAAUAAAAAAAAAAAAAAD/fwAA/38AAAAAAAAJAAAABAAAAARNBpkeAAAAaAAAAAAAAAAAAAAAAAAAAAAAAAAAAAAAECcAABAnAAAAAAAAAAAAAAAAAAAAAAAAAAAAAAAAAAAAAAAAAAAAABQAAAAAAAAAwMD/AAAAAABkAAAAMgAAAAAAAABkAAAAAAAAAH9/fwAKAAAAIgAAABgAAAAAAAAAAAAAAAAAAAAAAAAAAAAAAAAAAAAkAAAAJAAAAAAAAAAHAAAAAAAAAAAAAAAAAAAAAAAAAAAAAAAAAAAAf39/ACUAAABYAAAAAAAAAAAAAAAAAAAAAAAAAAAAAAAAAAAAAAAAAAAAAAAAAAAAAAAAAAAAAAA/AAAAAAAAAKCGAQAAAAAAAAAAAAAAAAAMAAAAAQAAAAAAAAAAAAAAAAAAAB8AAABUAAAAi47jAP///wEAAAAAAAAAAAAAAAAAAAAAAAAAAAAAAAAAAAAAAAAAAAAAAAJ/f38AWVlZA8zMzADAwP8Af39/AAAAAAAAAAAAAAAAAAAAAAAAAAAAIQAAABgAAAAUAAAAMAQAACoYAAADGQAAQBsAABAAAAAmAAAACAAAAP//////////"/>
+                <pr:smNativeData xmlns:pr="smNativeData" xmlns="smNativeData" val="SMDATA_15_FUV5ZhMAAAAlAAAAZQAAAA0AAAAAqQEAAJAAAACpAQAAkAAAAAAAAAABAAAAAAAAAAEAAABQAAAAhbacS3FV1T8AAAAAAAAAAAAAAAAAAOA/AAAAAAAA4D8AAAAAAADgPwAAAAAAAOA/AAAAAAAA4D8AAAAAAADgPwAAAAAAAOA/AAAAAAAA4D8CAAAAjAAAAAEAAAAAAAAAi47jAP///wgAAAAAAAAAAAAAAAAAAAAAAAAAAAAAAAAAAAAAeAAAAAEAAABAAAAAAAAAAAAAAABaAAAAAAAAAAAAAAAAAAAAAAAAAAAAAAAAAAAAAAAAAAAAAAAAAAAAAAAAAAAAAAAAAAAAAAAAAAAAAAAAAAAAAAAAAAAAAAAAAAAAFAAAADwAAAAAAAAAAAAAAAAAAAkUAAAAAQAAABQAAAAUAAAAFAAAAAEAAAAAAAAAZAAAAGQAAAAAAAAAZAAAAGQAAAAVAAAAYAAAAAAAAAAAAAAADwAAACADAAAAAAAAAAAAAAEAAACgMgAAVgcAAKr4//8BAAAAf39/AAEAAABkAAAAAAAAABQAAABAHwAAAAAAACYAAAAAAAAAwOD//wAAAAAmAAAAZAAAABYAAABMAAAAAAAAAAAAAAAEAAAAAAAAAAEAAABZWVkKAAAAACgAAAAoAAAAZAAAAGQAAAAAAAAAzMzMAAAAAABQAAAAUAAAAGQAAABkAAAAAAAAABcAAAAUAAAAAAAAAAAAAAD/fwAA/38AAAAAAAAJAAAABAAAAARNBpkeAAAAaAAAAAAAAAAAAAAAAAAAAAAAAAAAAAAAECcAABAnAAAAAAAAAAAAAAAAAAAAAAAAAAAAAAAAAAAAAAAAAAAAABQAAAAAAAAAwMD/AAAAAABkAAAAMgAAAAAAAABkAAAAAAAAAH9/fwAKAAAAIgAAABgAAAAAAAAAAAAAAAAAAAAAAAAAAAAAAAAAAAAkAAAAJAAAAAAAAAAHAAAAAAAAAAAAAAAAAAAAAAAAAAAAAAAAAAAAf39/ACUAAABYAAAAAAAAAAAAAAAAAAAAAAAAAAAAAAAAAAAAAAAAAAAAAAAAAAAAAAAAAAAAAAA/AAAAAAAAAKCGAQAAAAAAAAAAAAAAAAAMAAAAAQAAAAAAAAAAAAAAAAAAAB8AAABUAAAAi47jAP///wEAAAAAAAAAAAAAAAAAAAAAAAAAAAAAAAAAAAAAAAAAAAAAAAJ/f38AWVlZA8zMzADAwP8Af39/AAAAAAAAAAAAAAAAAAAAAAAAAAAAIQAAABgAAAAUAAAAMAQAACoYAAADGQAAQBsAABAAAAAmAAAACAAAAP//////////"/>
               </a:ext>
             </a:extLst>
           </p:cNvSpPr>
@@ -11350,7 +11350,7 @@
           <p:cNvSpPr>
             <a:extLst>
               <a:ext uri="smNativeData">
-                <pr:smNativeData xmlns:pr="smNativeData" xmlns="smNativeData" val="SMDATA_15_LkR5ZhMAAAAlAAAAZQAAAA0AAAAAqQEAAJAAAACpAQAAkAAAAAAAAAABAAAAAAAAAAEAAABQAAAAhbacS3FV1T8AAAAAAAAAAAAAAAAAAOA/AAAAAAAA4D8AAAAAAADgPwAAAAAAAOA/AAAAAAAA4D8AAAAAAADgPwAAAAAAAOA/AAAAAAAA4D8CAAAAjAAAAAEAAAAAAAAAi47jAP///wgAAAAAAAAAAAAAAAAAAAAAAAAAAAAAAAAAAAAAeAAAAAEAAABAAAAAAAAAAAAAAABaAAAAAAAAAAAAAAAAAAAAAAAAAAAAAAAAAAAAAAAAAAAAAAAAAAAAAAAAAAAAAAAAAAAAAAAAAAAAAAAAAAAAAAAAAAAAAAAAAAAAFAAAADwAAAAAAAAAAAAAAAAAAAkUAAAAAQAAABQAAAAUAAAAFAAAAAEAAAAAAAAAZAAAAGQAAAAAAAAAZAAAAGQAAAAVAAAAYAAAAAAAAAAAAAAADwAAACADAAAAAAAAAAAAAAEAAACgMgAAVgcAAKr4//8BAAAAf39/AAEAAABkAAAAAAAAABQAAABAHwAAAAAAACYAAAAAAAAAwOD//wAAAAAmAAAAZAAAABYAAABMAAAAAAAAAAAAAAAEAAAAAAAAAAEAAABZWVkKAAAAACgAAAAoAAAAZAAAAGQAAAAAAAAAzMzMAAAAAABQAAAAUAAAAGQAAABkAAAAAAAAABcAAAAUAAAAAAAAAAAAAAD/fwAA/38AAAAAAAAJAAAABAAAAFQBpU4eAAAAaAAAAAAAAAAAAAAAAAAAAAAAAAAAAAAAECcAABAnAAAAAAAAAAAAAAAAAAAAAAAAAAAAAAAAAAAAAAAAAAAAABQAAAAAAAAAwMD/AAAAAABkAAAAMgAAAAAAAABkAAAAAAAAAH9/fwAKAAAAIgAAABgAAAAAAAAAAAAAAAAAAAAAAAAAAAAAAAAAAAAkAAAAJAAAAAAAAAAHAAAAAAAAAAAAAAAAAAAAAAAAAAAAAAAAAAAAf39/ACUAAABYAAAAAAAAAAAAAAAAAAAAAAAAAAAAAAAAAAAAAAAAAAAAAAAAAAAAAAAAAAAAAAA/AAAAAAAAAKCGAQAAAAAAAAAAAAAAAAAMAAAAAQAAAAAAAAAAAAAAAAAAAB8AAABUAAAAi47jAP///wEAAAAAAAAAAAAAAAAAAAAAAAAAAAAAAAAAAAAAAAAAAAAAAAJ/f38AWVlZA8zMzADAwP8Af39/AAAAAAAAAAAAAAAAAAAAAAAAAAAAIQAAABgAAAAUAAAAMAQAAPkcAAADGQAADyAAABAAAAAmAAAACAAAAP//////////"/>
+                <pr:smNativeData xmlns:pr="smNativeData" xmlns="smNativeData" val="SMDATA_15_FUV5ZhMAAAAlAAAAZQAAAA0AAAAAqQEAAJAAAACpAQAAkAAAAAAAAAABAAAAAAAAAAEAAABQAAAAhbacS3FV1T8AAAAAAAAAAAAAAAAAAOA/AAAAAAAA4D8AAAAAAADgPwAAAAAAAOA/AAAAAAAA4D8AAAAAAADgPwAAAAAAAOA/AAAAAAAA4D8CAAAAjAAAAAEAAAAAAAAAi47jAP///wgAAAAAAAAAAAAAAAAAAAAAAAAAAAAAAAAAAAAAeAAAAAEAAABAAAAAAAAAAAAAAABaAAAAAAAAAAAAAAAAAAAAAAAAAAAAAAAAAAAAAAAAAAAAAAAAAAAAAAAAAAAAAAAAAAAAAAAAAAAAAAAAAAAAAAAAAAAAAAAAAAAAFAAAADwAAAAAAAAAAAAAAAAAAAkUAAAAAQAAABQAAAAUAAAAFAAAAAEAAAAAAAAAZAAAAGQAAAAAAAAAZAAAAGQAAAAVAAAAYAAAAAAAAAAAAAAADwAAACADAAAAAAAAAAAAAAEAAACgMgAAVgcAAKr4//8BAAAAf39/AAEAAABkAAAAAAAAABQAAABAHwAAAAAAACYAAAAAAAAAwOD//wAAAAAmAAAAZAAAABYAAABMAAAAAAAAAAAAAAAEAAAAAAAAAAEAAABZWVkKAAAAACgAAAAoAAAAZAAAAGQAAAAAAAAAzMzMAAAAAABQAAAAUAAAAGQAAABkAAAAAAAAABcAAAAUAAAAAAAAAAAAAAD/fwAA/38AAAAAAAAJAAAABAAAAFQBpU4eAAAAaAAAAAAAAAAAAAAAAAAAAAAAAAAAAAAAECcAABAnAAAAAAAAAAAAAAAAAAAAAAAAAAAAAAAAAAAAAAAAAAAAABQAAAAAAAAAwMD/AAAAAABkAAAAMgAAAAAAAABkAAAAAAAAAH9/fwAKAAAAIgAAABgAAAAAAAAAAAAAAAAAAAAAAAAAAAAAAAAAAAAkAAAAJAAAAAAAAAAHAAAAAAAAAAAAAAAAAAAAAAAAAAAAAAAAAAAAf39/ACUAAABYAAAAAAAAAAAAAAAAAAAAAAAAAAAAAAAAAAAAAAAAAAAAAAAAAAAAAAAAAAAAAAA/AAAAAAAAAKCGAQAAAAAAAAAAAAAAAAAMAAAAAQAAAAAAAAAAAAAAAAAAAB8AAABUAAAAi47jAP///wEAAAAAAAAAAAAAAAAAAAAAAAAAAAAAAAAAAAAAAAAAAAAAAAJ/f38AWVlZA8zMzADAwP8Af39/AAAAAAAAAAAAAAAAAAAAAAAAAAAAIQAAABgAAAAUAAAAMAQAAPkcAAADGQAADyAAABAAAAAmAAAACAAAAP//////////"/>
               </a:ext>
             </a:extLst>
           </p:cNvSpPr>
@@ -11415,7 +11415,7 @@
           <p:cNvSpPr>
             <a:extLst>
               <a:ext uri="smNativeData">
-                <pr:smNativeData xmlns:pr="smNativeData" xmlns="smNativeData" val="SMDATA_15_LkR5ZhMAAAAlAAAAZQAAAA0AAAAAqQEAAJAAAACpAQAAkAAAAAAAAAABAAAAAAAAAAEAAABQAAAAhbacS3FV1T8AAAAAAAAAAAAAAAAAAOA/AAAAAAAA4D8AAAAAAADgPwAAAAAAAOA/AAAAAAAA4D8AAAAAAADgPwAAAAAAAOA/AAAAAAAA4D8CAAAAjAAAAAEAAAAAAAAAi47jAP///wgAAAAAAAAAAAAAAAAAAAAAAAAAAAAAAAAAAAAAeAAAAAEAAABAAAAAAAAAAAAAAABaAAAAAAAAAAAAAAAAAAAAAAAAAAAAAAAAAAAAAAAAAAAAAAAAAAAAAAAAAAAAAAAAAAAAAAAAAAAAAAAAAAAAAAAAAAAAAAAAAAAAFAAAADwAAAAAAAAAAAAAAAAAAAkUAAAAAQAAABQAAAAUAAAAFAAAAAEAAAAAAAAAZAAAAGQAAAAAAAAAZAAAAGQAAAAVAAAAYAAAAAAAAAAAAAAADwAAACADAAAAAAAAAAAAAAEAAACgMgAAVgcAAKr4//8BAAAAf39/AAEAAABkAAAAAAAAABQAAABAHwAAAAAAACYAAAAAAAAAwOD//wAAAAAmAAAAZAAAABYAAABMAAAAAAAAAAAAAAAEAAAAAAAAAAEAAABZWVkKAAAAACgAAAAoAAAAZAAAAGQAAAAAAAAAzMzMAAAAAABQAAAAUAAAAGQAAABkAAAAAAAAABcAAAAUAAAAAAAAAAAAAAD/fwAA/38AAAAAAAAJAAAABAAAACOg4r4eAAAAaAAAAAAAAAAAAAAAAAAAAAAAAAAAAAAAECcAABAnAAAAAAAAAAAAAAAAAAAAAAAAAAAAAAAAAAAAAAAAAAAAABQAAAAAAAAAwMD/AAAAAABkAAAAMgAAAAAAAABkAAAAAAAAAH9/fwAKAAAAIgAAABgAAAAAAAAAAAAAAAAAAAAAAAAAAAAAAAAAAAAkAAAAJAAAAAAAAAAHAAAAAAAAAAAAAAAAAAAAAAAAAAAAAAAAAAAAf39/ACUAAABYAAAAAAAAAAAAAAAAAAAAAAAAAAAAAAAAAAAAAAAAAAAAAAAAAAAAAAAAAAAAAAA/AAAAAAAAAKCGAQAAAAAAAAAAAAAAAAAMAAAAAQAAAAAAAAAAAAAAAAAAAB8AAABUAAAAi47jAP///wEAAAAAAAAAAAAAAAAAAAAAAAAAAAAAAAAAAAAAAAAAAAAAAAJ/f38AWVlZA8zMzADAwP8Af39/AAAAAAAAAAAAAAAAAAAAAAAAAAAAIQAAABgAAAAUAAAAMAQAAMkhAAADGQAA3yQAABAAAAAmAAAACAAAAP//////////"/>
+                <pr:smNativeData xmlns:pr="smNativeData" xmlns="smNativeData" val="SMDATA_15_FUV5ZhMAAAAlAAAAZQAAAA0AAAAAqQEAAJAAAACpAQAAkAAAAAAAAAABAAAAAAAAAAEAAABQAAAAhbacS3FV1T8AAAAAAAAAAAAAAAAAAOA/AAAAAAAA4D8AAAAAAADgPwAAAAAAAOA/AAAAAAAA4D8AAAAAAADgPwAAAAAAAOA/AAAAAAAA4D8CAAAAjAAAAAEAAAAAAAAAi47jAP///wgAAAAAAAAAAAAAAAAAAAAAAAAAAAAAAAAAAAAAeAAAAAEAAABAAAAAAAAAAAAAAABaAAAAAAAAAAAAAAAAAAAAAAAAAAAAAAAAAAAAAAAAAAAAAAAAAAAAAAAAAAAAAAAAAAAAAAAAAAAAAAAAAAAAAAAAAAAAAAAAAAAAFAAAADwAAAAAAAAAAAAAAAAAAAkUAAAAAQAAABQAAAAUAAAAFAAAAAEAAAAAAAAAZAAAAGQAAAAAAAAAZAAAAGQAAAAVAAAAYAAAAAAAAAAAAAAADwAAACADAAAAAAAAAAAAAAEAAACgMgAAVgcAAKr4//8BAAAAf39/AAEAAABkAAAAAAAAABQAAABAHwAAAAAAACYAAAAAAAAAwOD//wAAAAAmAAAAZAAAABYAAABMAAAAAAAAAAAAAAAEAAAAAAAAAAEAAABZWVkKAAAAACgAAAAoAAAAZAAAAGQAAAAAAAAAzMzMAAAAAABQAAAAUAAAAGQAAABkAAAAAAAAABcAAAAUAAAAAAAAAAAAAAD/fwAA/38AAAAAAAAJAAAABAAAACOg4r4eAAAAaAAAAAAAAAAAAAAAAAAAAAAAAAAAAAAAECcAABAnAAAAAAAAAAAAAAAAAAAAAAAAAAAAAAAAAAAAAAAAAAAAABQAAAAAAAAAwMD/AAAAAABkAAAAMgAAAAAAAABkAAAAAAAAAH9/fwAKAAAAIgAAABgAAAAAAAAAAAAAAAAAAAAAAAAAAAAAAAAAAAAkAAAAJAAAAAAAAAAHAAAAAAAAAAAAAAAAAAAAAAAAAAAAAAAAAAAAf39/ACUAAABYAAAAAAAAAAAAAAAAAAAAAAAAAAAAAAAAAAAAAAAAAAAAAAAAAAAAAAAAAAAAAAA/AAAAAAAAAKCGAQAAAAAAAAAAAAAAAAAMAAAAAQAAAAAAAAAAAAAAAAAAAB8AAABUAAAAi47jAP///wEAAAAAAAAAAAAAAAAAAAAAAAAAAAAAAAAAAAAAAAAAAAAAAAJ/f38AWVlZA8zMzADAwP8Af39/AAAAAAAAAAAAAAAAAAAAAAAAAAAAIQAAABgAAAAUAAAAMAQAAMkhAAADGQAA3yQAABAAAAAmAAAACAAAAP//////////"/>
               </a:ext>
             </a:extLst>
           </p:cNvSpPr>
@@ -11482,7 +11482,7 @@
             <a:endCxn id="4" idx="1"/>
             <a:extLst>
               <a:ext uri="smNativeData">
-                <pr:smNativeData xmlns:pr="smNativeData" xmlns="smNativeData" val="SMDATA_15_LkR5ZhMAAAAlAAAADwAAAA0AAAAAkAAAAEgAAACQAAAASAAAAAAAAAAAAAAAAAAAAAEAAABQAAAAAAAAAADWiMAAAAAAAAAAAAAAAAAAAPA/AAAAAAAA4D8AAAAAAADgPwAAAAAAAOA/AAAAAAAA4D8AAAAAAADgPwAAAAAAAOA/AAAAAAAA4D8CAAAAjAAAAAAAAAAAAAAAQoX0DP///wgAAAAAAAAAAAAAAAAAAAAAAAAAAAAAAAAAAAAAZAAAAAEAAABAAAAAAAAAAAAAAAAAAAAAAAAAAAAAAAAAAAAAAAAAAAAAAAAAAAAAAAAAAAAAAAAAAAAAAAAAAAAAAAAAAAAAAAAAAAAAAAAAAAAAAAAAAAAAAAAAAAAAFAAAADwAAAABAAAAAwAAAAE9hQAeAAAAAQAAACMAAAAjAAAAIwAAAB4AAAAAAAAAZAAAAGQAAAAAAAAAZAAAAGQAAAAVAAAAYAAAAAAAAAAAAAAADwAAACADAAAAAAAAAAAAAAEAAACgMgAAVgcAAKr4//8BAAAAf39/AAEAAABkAAAAAAAAABQAAABAHwAAAAAAACYAAAAAAAAAwOD//wAAAAAmAAAAZAAAABYAAABMAAAAAAAAAAAAAAAEAAAAAAAAAAEAAABZWVkKAAAAACgAAAAoAAAAZAAAAGQAAAAAAAAAzMzMAAAAAABQAAAAUAAAAGQAAABkAAAAAAAAABcAAAAUAAAAAAAAAAAAAAD/fwAA/38AAAAAAAAJAAAABAAAAMkMAAAeAAAAaAAAAAAAAAAAAAAAAAAAAAAAAAAAAAAAECcAABAnAAAAAAAAAAAAAAAAAAAAAAAAAAAAAAAAAAAAAAAAAAAAABQAAAAAAAAAwMD/AAAAAABkAAAAMgAAAAAAAABkAAAAAAAAAH9/fwAKAAAAIgAAABgAAAAAAAAAAAAAAAAAAAAAAAAAAAAAAAAAAAAkAAAAJAAAAAAAAAAHAAAAAAAAAAAAAAAAAAAAAAAAAAAAAAAAAAAAf39/ACUAAABYAAAAAAAAAAAAAAAAAAAAAAAAAAAAAAAAAAAAAAAAAAAAAAAAAAAAAAAAAAAAAAA/AAAAAAAAAKCGAQAAAAAAAAAAAAAAAAAMAAAAAQAAAAAAAAAAAAAAAAAAAB8AAABUAAAAQoX0Bf///wEAAAAAAAAAAAAAAAAAAAAAAAAAAAAAAAAAAAAAAAAAAAE9hQB/f38AWVlZA8zMzADAwP8Af39/AAAAAAAAAAAAAAAAAAAAAAAAAAAAIQAAABgAAAAUAAAAMAQAAFgKAAAwBAAAaQ8AABAAAAAmAAAACAAAAP//////////"/>
+                <pr:smNativeData xmlns:pr="smNativeData" xmlns="smNativeData" val="SMDATA_15_FUV5ZhMAAAAlAAAADwAAAA0AAAAAkAAAAEgAAACQAAAASAAAAAAAAAAAAAAAAAAAAAEAAABQAAAAAAAAAADWiMAAAAAAAAAAAAAAAAAAAPA/AAAAAAAA4D8AAAAAAADgPwAAAAAAAOA/AAAAAAAA4D8AAAAAAADgPwAAAAAAAOA/AAAAAAAA4D8CAAAAjAAAAAAAAAAAAAAAQoX0DP///wgAAAAAAAAAAAAAAAAAAAAAAAAAAAAAAAAAAAAAZAAAAAEAAABAAAAAAAAAAAAAAAAAAAAAAAAAAAAAAAAAAAAAAAAAAAAAAAAAAAAAAAAAAAAAAAAAAAAAAAAAAAAAAAAAAAAAAAAAAAAAAAAAAAAAAAAAAAAAAAAAAAAAFAAAADwAAAABAAAAAwAAAAE9hQAeAAAAAQAAACMAAAAjAAAAIwAAAB4AAAAAAAAAZAAAAGQAAAAAAAAAZAAAAGQAAAAVAAAAYAAAAAAAAAAAAAAADwAAACADAAAAAAAAAAAAAAEAAACgMgAAVgcAAKr4//8BAAAAf39/AAEAAABkAAAAAAAAABQAAABAHwAAAAAAACYAAAAAAAAAwOD//wAAAAAmAAAAZAAAABYAAABMAAAAAAAAAAAAAAAEAAAAAAAAAAEAAABZWVkKAAAAACgAAAAoAAAAZAAAAGQAAAAAAAAAzMzMAAAAAABQAAAAUAAAAGQAAABkAAAAAAAAABcAAAAUAAAAAAAAAAAAAAD/fwAA/38AAAAAAAAJAAAABAAAAMkMAAAeAAAAaAAAAAAAAAAAAAAAAAAAAAAAAAAAAAAAECcAABAnAAAAAAAAAAAAAAAAAAAAAAAAAAAAAAAAAAAAAAAAAAAAABQAAAAAAAAAwMD/AAAAAABkAAAAMgAAAAAAAABkAAAAAAAAAH9/fwAKAAAAIgAAABgAAAAAAAAAAAAAAAAAAAAAAAAAAAAAAAAAAAAkAAAAJAAAAAAAAAAHAAAAAAAAAAAAAAAAAAAAAAAAAAAAAAAAAAAAf39/ACUAAABYAAAAAAAAAAAAAAAAAAAAAAAAAAAAAAAAAAAAAAAAAAAAAAAAAAAAAAAAAAAAAAA/AAAAAAAAAKCGAQAAAAAAAAAAAAAAAAAMAAAAAQAAAAAAAAAAAAAAAAAAAB8AAABUAAAAQoX0Bf///wEAAAAAAAAAAAAAAAAAAAAAAAAAAAAAAAAAAAAAAAAAAAE9hQB/f38AWVlZA8zMzADAwP8Af39/AAAAAAAAAAAAAAAAAAAAAAAAAAAAIQAAABgAAAAUAAAAMAQAAFgKAAAwBAAAaQ8AABAAAAAmAAAACAAAAP//////////"/>
               </a:ext>
             </a:extLst>
           </p:cNvCxnSpPr>
@@ -11518,7 +11518,7 @@
             <a:endCxn id="5" idx="1"/>
             <a:extLst>
               <a:ext uri="smNativeData">
-                <pr:smNativeData xmlns:pr="smNativeData" xmlns="smNativeData" val="SMDATA_15_LkR5ZhMAAAAlAAAADwAAAA0AAAAAkAAAAEgAAACQAAAASAAAAAAAAAAAAAAAAAAAAAEAAABQAAAAAAAAAADWiMAAAAAAAAAAAAAAAAAAAPA/AAAAAAAA4D8AAAAAAADgPwAAAAAAAOA/AAAAAAAA4D8AAAAAAADgPwAAAAAAAOA/AAAAAAAA4D8CAAAAjAAAAAAAAAAAAAAAQoX0DP///wgAAAAAAAAAAAAAAAAAAAAAAAAAAAAAAAAAAAAAZAAAAAEAAABAAAAAAAAAAAAAAAAAAAAAAAAAAAAAAAAAAAAAAAAAAAAAAAAAAAAAAAAAAAAAAAAAAAAAAAAAAAAAAAAAAAAAAAAAAAAAAAAAAAAAAAAAAAAAAAAAAAAAFAAAADwAAAABAAAAAwAAAAE9hQAeAAAAAQAAACMAAAAjAAAAIwAAAB4AAAAAAAAAZAAAAGQAAAAAAAAAZAAAAGQAAAAVAAAAYAAAAAAAAAAAAAAADwAAACADAAAAAAAAAAAAAAEAAACgMgAAVgcAAKr4//8BAAAAf39/AAEAAABkAAAAAAAAABQAAABAHwAAAAAAACYAAAAAAAAAwOD//wAAAAAmAAAAZAAAABYAAABMAAAAAAAAAAAAAAAEAAAAAAAAAAEAAABZWVkKAAAAACgAAAAoAAAAZAAAAGQAAAAAAAAAzMzMAAAAAABQAAAAUAAAAGQAAABkAAAAAAAAABcAAAAUAAAAAAAAAAAAAAD/fwAA/38AAAAAAAAJAAAABAAAAAAAAAAeAAAAaAAAAAAAAAAAAAAAAAAAAAAAAAAAAAAAECcAABAnAAAAAAAAAAAAAAAAAAAAAAAAAAAAAAAAAAAAAAAAAAAAABQAAAAAAAAAwMD/AAAAAABkAAAAMgAAAAAAAABkAAAAAAAAAH9/fwAKAAAAIgAAABgAAAAAAAAAAAAAAAAAAAAAAAAAAAAAAAAAAAAkAAAAJAAAAAAAAAAHAAAAAAAAAAAAAAAAAAAAAAAAAAAAAAAAAAAAf39/ACUAAABYAAAAAAAAAAAAAAAAAAAAAAAAAAAAAAAAAAAAAAAAAAAAAAAAAAAAAAAAAAAAAAA/AAAAAAAAAKCGAQAAAAAAAAAAAAAAAAAMAAAAAQAAAAAAAAAAAAAAAAAAAB8AAABUAAAAQoX0Bf///wEAAAAAAAAAAAAAAAAAAAAAAAAAAAAAAAAAAAAAAAAAAAE9hQB/f38AWVlZA8zMzADAwP8Af39/AAAAAAAAAAAAAAAAAAAAAAAAAAAAIQAAABgAAAAUAAAAMAQAAGkPAAAwBAAAjxQAABAAAAAmAAAACAAAAP//////////"/>
+                <pr:smNativeData xmlns:pr="smNativeData" xmlns="smNativeData" val="SMDATA_15_FUV5ZhMAAAAlAAAADwAAAA0AAAAAkAAAAEgAAACQAAAASAAAAAAAAAAAAAAAAAAAAAEAAABQAAAAAAAAAADWiMAAAAAAAAAAAAAAAAAAAPA/AAAAAAAA4D8AAAAAAADgPwAAAAAAAOA/AAAAAAAA4D8AAAAAAADgPwAAAAAAAOA/AAAAAAAA4D8CAAAAjAAAAAAAAAAAAAAAQoX0DP///wgAAAAAAAAAAAAAAAAAAAAAAAAAAAAAAAAAAAAAZAAAAAEAAABAAAAAAAAAAAAAAAAAAAAAAAAAAAAAAAAAAAAAAAAAAAAAAAAAAAAAAAAAAAAAAAAAAAAAAAAAAAAAAAAAAAAAAAAAAAAAAAAAAAAAAAAAAAAAAAAAAAAAFAAAADwAAAABAAAAAwAAAAE9hQAeAAAAAQAAACMAAAAjAAAAIwAAAB4AAAAAAAAAZAAAAGQAAAAAAAAAZAAAAGQAAAAVAAAAYAAAAAAAAAAAAAAADwAAACADAAAAAAAAAAAAAAEAAACgMgAAVgcAAKr4//8BAAAAf39/AAEAAABkAAAAAAAAABQAAABAHwAAAAAAACYAAAAAAAAAwOD//wAAAAAmAAAAZAAAABYAAABMAAAAAAAAAAAAAAAEAAAAAAAAAAEAAABZWVkKAAAAACgAAAAoAAAAZAAAAGQAAAAAAAAAzMzMAAAAAABQAAAAUAAAAGQAAABkAAAAAAAAABcAAAAUAAAAAAAAAAAAAAD/fwAA/38AAAAAAAAJAAAABAAAAAAAAAAeAAAAaAAAAAAAAAAAAAAAAAAAAAAAAAAAAAAAECcAABAnAAAAAAAAAAAAAAAAAAAAAAAAAAAAAAAAAAAAAAAAAAAAABQAAAAAAAAAwMD/AAAAAABkAAAAMgAAAAAAAABkAAAAAAAAAH9/fwAKAAAAIgAAABgAAAAAAAAAAAAAAAAAAAAAAAAAAAAAAAAAAAAkAAAAJAAAAAAAAAAHAAAAAAAAAAAAAAAAAAAAAAAAAAAAAAAAAAAAf39/ACUAAABYAAAAAAAAAAAAAAAAAAAAAAAAAAAAAAAAAAAAAAAAAAAAAAAAAAAAAAAAAAAAAAA/AAAAAAAAAKCGAQAAAAAAAAAAAAAAAAAMAAAAAQAAAAAAAAAAAAAAAAAAAB8AAABUAAAAQoX0Bf///wEAAAAAAAAAAAAAAAAAAAAAAAAAAAAAAAAAAAAAAAAAAAE9hQB/f38AWVlZA8zMzADAwP8Af39/AAAAAAAAAAAAAAAAAAAAAAAAAAAAIQAAABgAAAAUAAAAMAQAAGkPAAAwBAAAjxQAABAAAAAmAAAACAAAAP//////////"/>
               </a:ext>
             </a:extLst>
           </p:cNvCxnSpPr>
@@ -11554,7 +11554,7 @@
             <a:endCxn id="6" idx="1"/>
             <a:extLst>
               <a:ext uri="smNativeData">
-                <pr:smNativeData xmlns:pr="smNativeData" xmlns="smNativeData" val="SMDATA_15_LkR5ZhMAAAAlAAAADwAAAA0AAAAAkAAAAEgAAACQAAAASAAAAAAAAAAAAAAAAAAAAAEAAABQAAAAAAAAAADWiMAAAAAAAAAAAAAAAAAAAPA/AAAAAAAA4D8AAAAAAADgPwAAAAAAAOA/AAAAAAAA4D8AAAAAAADgPwAAAAAAAOA/AAAAAAAA4D8CAAAAjAAAAAAAAAAAAAAAQoX0DP///wgAAAAAAAAAAAAAAAAAAAAAAAAAAAAAAAAAAAAAZAAAAAEAAABAAAAAAAAAAAAAAAAAAAAAAAAAAAAAAAAAAAAAAAAAAAAAAAAAAAAAAAAAAAAAAAAAAAAAAAAAAAAAAAAAAAAAAAAAAAAAAAAAAAAAAAAAAAAAAAAAAAAAFAAAADwAAAABAAAAAwAAAAE9hQAeAAAAAQAAACMAAAAjAAAAIwAAAB4AAAAAAAAAZAAAAGQAAAAAAAAAZAAAAGQAAAAVAAAAYAAAAAAAAAAAAAAADwAAACADAAAAAAAAAAAAAAEAAACgMgAAVgcAAKr4//8BAAAAf39/AAEAAABkAAAAAAAAABQAAABAHwAAAAAAACYAAAAAAAAAwOD//wAAAAAmAAAAZAAAABYAAABMAAAAAAAAAAAAAAAEAAAAAAAAAAEAAABZWVkKAAAAACgAAAAoAAAAZAAAAGQAAAAAAAAAzMzMAAAAAABQAAAAUAAAAGQAAABkAAAAAAAAABcAAAAUAAAAAAAAAAAAAAD/fwAA/38AAAAAAAAJAAAABAAAAB++y0QeAAAAaAAAAAAAAAAAAAAAAAAAAAAAAAAAAAAAECcAABAnAAAAAAAAAAAAAAAAAAAAAAAAAAAAAAAAAAAAAAAAAAAAABQAAAAAAAAAwMD/AAAAAABkAAAAMgAAAAAAAABkAAAAAAAAAH9/fwAKAAAAIgAAABgAAAAAAAAAAAAAAAAAAAAAAAAAAAAAAAAAAAAkAAAAJAAAAAAAAAAHAAAAAAAAAAAAAAAAAAAAAAAAAAAAAAAAAAAAf39/ACUAAABYAAAAAAAAAAAAAAAAAAAAAAAAAAAAAAAAAAAAAAAAAAAAAAAAAAAAAAAAAAAAAAA/AAAAAAAAAKCGAQAAAAAAAAAAAAAAAAAMAAAAAQAAAAAAAAAAAAAAAAAAAB8AAABUAAAAQoX0Bf///wEAAAAAAAAAAAAAAAAAAAAAAAAAAAAAAAAAAAAAAAAAAAE9hQB/f38AWVlZA8zMzADAwP8Af39/AAAAAAAAAAAAAAAAAAAAAAAAAAAAIQAAABgAAAAUAAAAMAQAAI8UAAAwBAAAtRkAABAAAAAmAAAACAAAAP//////////"/>
+                <pr:smNativeData xmlns:pr="smNativeData" xmlns="smNativeData" val="SMDATA_15_FUV5ZhMAAAAlAAAADwAAAA0AAAAAkAAAAEgAAACQAAAASAAAAAAAAAAAAAAAAAAAAAEAAABQAAAAAAAAAADWiMAAAAAAAAAAAAAAAAAAAPA/AAAAAAAA4D8AAAAAAADgPwAAAAAAAOA/AAAAAAAA4D8AAAAAAADgPwAAAAAAAOA/AAAAAAAA4D8CAAAAjAAAAAAAAAAAAAAAQoX0DP///wgAAAAAAAAAAAAAAAAAAAAAAAAAAAAAAAAAAAAAZAAAAAEAAABAAAAAAAAAAAAAAAAAAAAAAAAAAAAAAAAAAAAAAAAAAAAAAAAAAAAAAAAAAAAAAAAAAAAAAAAAAAAAAAAAAAAAAAAAAAAAAAAAAAAAAAAAAAAAAAAAAAAAFAAAADwAAAABAAAAAwAAAAE9hQAeAAAAAQAAACMAAAAjAAAAIwAAAB4AAAAAAAAAZAAAAGQAAAAAAAAAZAAAAGQAAAAVAAAAYAAAAAAAAAAAAAAADwAAACADAAAAAAAAAAAAAAEAAACgMgAAVgcAAKr4//8BAAAAf39/AAEAAABkAAAAAAAAABQAAABAHwAAAAAAACYAAAAAAAAAwOD//wAAAAAmAAAAZAAAABYAAABMAAAAAAAAAAAAAAAEAAAAAAAAAAEAAABZWVkKAAAAACgAAAAoAAAAZAAAAGQAAAAAAAAAzMzMAAAAAABQAAAAUAAAAGQAAABkAAAAAAAAABcAAAAUAAAAAAAAAAAAAAD/fwAA/38AAAAAAAAJAAAABAAAAB++y0QeAAAAaAAAAAAAAAAAAAAAAAAAAAAAAAAAAAAAECcAABAnAAAAAAAAAAAAAAAAAAAAAAAAAAAAAAAAAAAAAAAAAAAAABQAAAAAAAAAwMD/AAAAAABkAAAAMgAAAAAAAABkAAAAAAAAAH9/fwAKAAAAIgAAABgAAAAAAAAAAAAAAAAAAAAAAAAAAAAAAAAAAAAkAAAAJAAAAAAAAAAHAAAAAAAAAAAAAAAAAAAAAAAAAAAAAAAAAAAAf39/ACUAAABYAAAAAAAAAAAAAAAAAAAAAAAAAAAAAAAAAAAAAAAAAAAAAAAAAAAAAAAAAAAAAAA/AAAAAAAAAKCGAQAAAAAAAAAAAAAAAAAMAAAAAQAAAAAAAAAAAAAAAAAAAB8AAABUAAAAQoX0Bf///wEAAAAAAAAAAAAAAAAAAAAAAAAAAAAAAAAAAAAAAAAAAAE9hQB/f38AWVlZA8zMzADAwP8Af39/AAAAAAAAAAAAAAAAAAAAAAAAAAAAIQAAABgAAAAUAAAAMAQAAI8UAAAwBAAAtRkAABAAAAAmAAAACAAAAP//////////"/>
               </a:ext>
             </a:extLst>
           </p:cNvCxnSpPr>
@@ -11588,7 +11588,7 @@
           <p:cNvCxnSpPr>
             <a:extLst>
               <a:ext uri="smNativeData">
-                <pr:smNativeData xmlns:pr="smNativeData" xmlns="smNativeData" val="SMDATA_15_LkR5ZhMAAAAlAAAADwAAAA0AAAAAkAAAAEgAAACQAAAASAAAAAAAAAAAAAAAAAAAAAEAAABQAAAAAAAAAADWiMAAAAAAAAAAAAAAAAAAAPA/AAAAAAAA4D8AAAAAAADgPwAAAAAAAOA/AAAAAAAA4D8AAAAAAADgPwAAAAAAAOA/AAAAAAAA4D8CAAAAjAAAAAAAAAAAAAAAQoX0DP///wgAAAAAAAAAAAAAAAAAAAAAAAAAAAAAAAAAAAAAZAAAAAEAAABAAAAAAAAAAAAAAAAAAAAAAAAAAAAAAAAAAAAAAAAAAAAAAAAAAAAAAAAAAAAAAAAAAAAAAAAAAAAAAAAAAAAAAAAAAAAAAAAAAAAAAAAAAAAAAAAAAAAAFAAAADwAAAABAAAAAwAAAAE9hQAeAAAAAQAAACMAAAAjAAAAIwAAAB4AAAAAAAAAZAAAAGQAAAAAAAAAZAAAAGQAAAAVAAAAYAAAAAAAAAAAAAAADwAAACADAAAAAAAAAAAAAAEAAACgMgAAVgcAAKr4//8BAAAAf39/AAEAAABkAAAAAAAAABQAAABAHwAAAAAAACYAAAAAAAAAwOD//wAAAAAmAAAAZAAAABYAAABMAAAAAAAAAAAAAAAEAAAAAAAAAAEAAABZWVkKAAAAACgAAAAoAAAAZAAAAGQAAAAAAAAAzMzMAAAAAABQAAAAUAAAAGQAAABkAAAAAAAAABcAAAAUAAAAAAAAAAAAAAD/fwAA/38AAAAAAAAJAAAABAAAAAAAAAAeAAAAaAAAAAAAAAAAAAAAAAAAAAAAAAAAAAAAECcAABAnAAAAAAAAAAAAAAAAAAAAAAAAAAAAAAAAAAAAAAAAAAAAABQAAAAAAAAAwMD/AAAAAABkAAAAMgAAAAAAAABkAAAAAAAAAH9/fwAKAAAAIgAAABgAAAAAAAAAAAAAAAAAAAAAAAAAAAAAAAAAAAAkAAAAJAAAAAAAAAAHAAAAAAAAAAAAAAAAAAAAAAAAAAAAAAAAAAAAf39/ACUAAABYAAAAAAAAAAAAAAAAAAAAAAAAAAAAAAAAAAAAAAAAAAAAAAAAAAAAAAAAAAAAAAA/AAAAAAAAAKCGAQAAAAAAAAAAAAAAAAAMAAAAAQAAAAAAAAAAAAAAAAAAAB8AAABUAAAAQoX0Bf///wEAAAAAAAAAAAAAAAAAAAAAAAAAAAAAAAAAAAAAAAAAAAE9hQB/f38AWVlZA8zMzADAwP8Af39/AAAAAAAAAAAAAAAAAAAAAAAAAAAAIQAAABgAAAAUAAAAMAQAAPUZAAAxBAAAGx8AABAAAAAmAAAACAAAAP//////////"/>
+                <pr:smNativeData xmlns:pr="smNativeData" xmlns="smNativeData" val="SMDATA_15_FUV5ZhMAAAAlAAAADwAAAA0AAAAAkAAAAEgAAACQAAAASAAAAAAAAAAAAAAAAAAAAAEAAABQAAAAAAAAAADWiMAAAAAAAAAAAAAAAAAAAPA/AAAAAAAA4D8AAAAAAADgPwAAAAAAAOA/AAAAAAAA4D8AAAAAAADgPwAAAAAAAOA/AAAAAAAA4D8CAAAAjAAAAAAAAAAAAAAAQoX0DP///wgAAAAAAAAAAAAAAAAAAAAAAAAAAAAAAAAAAAAAZAAAAAEAAABAAAAAAAAAAAAAAAAAAAAAAAAAAAAAAAAAAAAAAAAAAAAAAAAAAAAAAAAAAAAAAAAAAAAAAAAAAAAAAAAAAAAAAAAAAAAAAAAAAAAAAAAAAAAAAAAAAAAAFAAAADwAAAABAAAAAwAAAAE9hQAeAAAAAQAAACMAAAAjAAAAIwAAAB4AAAAAAAAAZAAAAGQAAAAAAAAAZAAAAGQAAAAVAAAAYAAAAAAAAAAAAAAADwAAACADAAAAAAAAAAAAAAEAAACgMgAAVgcAAKr4//8BAAAAf39/AAEAAABkAAAAAAAAABQAAABAHwAAAAAAACYAAAAAAAAAwOD//wAAAAAmAAAAZAAAABYAAABMAAAAAAAAAAAAAAAEAAAAAAAAAAEAAABZWVkKAAAAACgAAAAoAAAAZAAAAGQAAAAAAAAAzMzMAAAAAABQAAAAUAAAAGQAAABkAAAAAAAAABcAAAAUAAAAAAAAAAAAAAD/fwAA/38AAAAAAAAJAAAABAAAAAAAAAAeAAAAaAAAAAAAAAAAAAAAAAAAAAAAAAAAAAAAECcAABAnAAAAAAAAAAAAAAAAAAAAAAAAAAAAAAAAAAAAAAAAAAAAABQAAAAAAAAAwMD/AAAAAABkAAAAMgAAAAAAAABkAAAAAAAAAH9/fwAKAAAAIgAAABgAAAAAAAAAAAAAAAAAAAAAAAAAAAAAAAAAAAAkAAAAJAAAAAAAAAAHAAAAAAAAAAAAAAAAAAAAAAAAAAAAAAAAAAAAf39/ACUAAABYAAAAAAAAAAAAAAAAAAAAAAAAAAAAAAAAAAAAAAAAAAAAAAAAAAAAAAAAAAAAAAA/AAAAAAAAAKCGAQAAAAAAAAAAAAAAAAAMAAAAAQAAAAAAAAAAAAAAAAAAAB8AAABUAAAAQoX0Bf///wEAAAAAAAAAAAAAAAAAAAAAAAAAAAAAAAAAAAAAAAAAAAE9hQB/f38AWVlZA8zMzADAwP8Af39/AAAAAAAAAAAAAAAAAAAAAAAAAAAAIQAAABgAAAAUAAAAMAQAAPUZAAAxBAAAGx8AABAAAAAmAAAACAAAAP//////////"/>
               </a:ext>
             </a:extLst>
           </p:cNvCxnSpPr>
@@ -11622,7 +11622,7 @@
           <p:cNvCxnSpPr>
             <a:extLst>
               <a:ext uri="smNativeData">
-                <pr:smNativeData xmlns:pr="smNativeData" xmlns="smNativeData" val="SMDATA_15_LkR5ZhMAAAAlAAAADwAAAA0AAAAAkAAAAEgAAACQAAAASAAAAAAAAAAAAAAAAAAAAAEAAABQAAAAAAAAAADWiMAAAAAAAAAAAAAAAAAAAPA/AAAAAAAA4D8AAAAAAADgPwAAAAAAAOA/AAAAAAAA4D8AAAAAAADgPwAAAAAAAOA/AAAAAAAA4D8CAAAAjAAAAAAAAAAAAAAAQoX0DP///wgAAAAAAAAAAAAAAAAAAAAAAAAAAAAAAAAAAAAAZAAAAAEAAABAAAAAAAAAAAAAAAAAAAAAAAAAAAAAAAAAAAAAAAAAAAAAAAAAAAAAAAAAAAAAAAAAAAAAAAAAAAAAAAAAAAAAAAAAAAAAAAAAAAAAAAAAAAAAAAAAAAAAFAAAADwAAAABAAAAAwAAAAE9hQAeAAAAAQAAACMAAAAjAAAAIwAAAB4AAAAAAAAAZAAAAGQAAAAAAAAAZAAAAGQAAAAVAAAAYAAAAAAAAAAAAAAADwAAACADAAAAAAAAAAAAAAEAAACgMgAAVgcAAKr4//8BAAAAf39/AAEAAABkAAAAAAAAABQAAABAHwAAAAAAACYAAAAAAAAAwOD//wAAAAAmAAAAZAAAABYAAABMAAAAAAAAAAAAAAAEAAAAAAAAAAEAAABZWVkKAAAAACgAAAAoAAAAZAAAAGQAAAAAAAAAzMzMAAAAAABQAAAAUAAAAGQAAABkAAAAAAAAABcAAAAUAAAAAAAAAAAAAAD/fwAA/38AAAAAAAAJAAAABAAAACgAAAAeAAAAaAAAAAAAAAAAAAAAAAAAAAAAAAAAAAAAECcAABAnAAAAAAAAAAAAAAAAAAAAAAAAAAAAAAAAAAAAAAAAAAAAABQAAAAAAAAAwMD/AAAAAABkAAAAMgAAAAAAAABkAAAAAAAAAH9/fwAKAAAAIgAAABgAAAAAAAAAAAAAAAAAAAAAAAAAAAAAAAAAAAAkAAAAJAAAAAAAAAAHAAAAAAAAAAAAAAAAAAAAAAAAAAAAAAAAAAAAf39/ACUAAABYAAAAAAAAAAAAAAAAAAAAAAAAAAAAAAAAAAAAAAAAAAAAAAAAAAAAAAAAAAAAAAA/AAAAAAAAAKCGAQAAAAAAAAAAAAAAAAAMAAAAAQAAAAAAAAAAAAAAAAAAAB8AAABUAAAAQoX0Bf///wEAAAAAAAAAAAAAAAAAAAAAAAAAAAAAAAAAAAAAAAAAAAE9hQB/f38AWVlZA8zMzADAwP8Af39/AAAAAAAAAAAAAAAAAAAAAAAAAAAAIQAAABgAAAAUAAAAMAQAAFofAAAxBAAAgCQAABAAAAAmAAAACAAAAP//////////"/>
+                <pr:smNativeData xmlns:pr="smNativeData" xmlns="smNativeData" val="SMDATA_15_FUV5ZhMAAAAlAAAADwAAAA0AAAAAkAAAAEgAAACQAAAASAAAAAAAAAAAAAAAAAAAAAEAAABQAAAAAAAAAADWiMAAAAAAAAAAAAAAAAAAAPA/AAAAAAAA4D8AAAAAAADgPwAAAAAAAOA/AAAAAAAA4D8AAAAAAADgPwAAAAAAAOA/AAAAAAAA4D8CAAAAjAAAAAAAAAAAAAAAQoX0DP///wgAAAAAAAAAAAAAAAAAAAAAAAAAAAAAAAAAAAAAZAAAAAEAAABAAAAAAAAAAAAAAAAAAAAAAAAAAAAAAAAAAAAAAAAAAAAAAAAAAAAAAAAAAAAAAAAAAAAAAAAAAAAAAAAAAAAAAAAAAAAAAAAAAAAAAAAAAAAAAAAAAAAAFAAAADwAAAABAAAAAwAAAAE9hQAeAAAAAQAAACMAAAAjAAAAIwAAAB4AAAAAAAAAZAAAAGQAAAAAAAAAZAAAAGQAAAAVAAAAYAAAAAAAAAAAAAAADwAAACADAAAAAAAAAAAAAAEAAACgMgAAVgcAAKr4//8BAAAAf39/AAEAAABkAAAAAAAAABQAAABAHwAAAAAAACYAAAAAAAAAwOD//wAAAAAmAAAAZAAAABYAAABMAAAAAAAAAAAAAAAEAAAAAAAAAAEAAABZWVkKAAAAACgAAAAoAAAAZAAAAGQAAAAAAAAAzMzMAAAAAABQAAAAUAAAAGQAAABkAAAAAAAAABcAAAAUAAAAAAAAAAAAAAD/fwAA/38AAAAAAAAJAAAABAAAACgAAAAeAAAAaAAAAAAAAAAAAAAAAAAAAAAAAAAAAAAAECcAABAnAAAAAAAAAAAAAAAAAAAAAAAAAAAAAAAAAAAAAAAAAAAAABQAAAAAAAAAwMD/AAAAAABkAAAAMgAAAAAAAABkAAAAAAAAAH9/fwAKAAAAIgAAABgAAAAAAAAAAAAAAAAAAAAAAAAAAAAAAAAAAAAkAAAAJAAAAAAAAAAHAAAAAAAAAAAAAAAAAAAAAAAAAAAAAAAAAAAAf39/ACUAAABYAAAAAAAAAAAAAAAAAAAAAAAAAAAAAAAAAAAAAAAAAAAAAAAAAAAAAAAAAAAAAAA/AAAAAAAAAKCGAQAAAAAAAAAAAAAAAAAMAAAAAQAAAAAAAAAAAAAAAAAAAB8AAABUAAAAQoX0Bf///wEAAAAAAAAAAAAAAAAAAAAAAAAAAAAAAAAAAAAAAAAAAAE9hQB/f38AWVlZA8zMzADAwP8Af39/AAAAAAAAAAAAAAAAAAAAAAAAAAAAIQAAABgAAAAUAAAAMAQAAFofAAAxBAAAgCQAABAAAAAmAAAACAAAAP//////////"/>
               </a:ext>
             </a:extLst>
           </p:cNvCxnSpPr>
@@ -11689,7 +11689,7 @@
             <a:spLocks noGrp="1" noChangeArrowheads="1"/>
             <a:extLst>
               <a:ext uri="smNativeData">
-                <pr:smNativeData xmlns:pr="smNativeData" xmlns="smNativeData" val="SMDATA_15_LkR5ZhMAAAAlAAAAZAAAAA0AAAAAkAAAAJAAAACQAAAAkAAAAAAAAAAAAAAAAAAAAAEAAABQAAAAAAAAAAAA4D8AAAAAAADgPwAAAAAAAOA/AAAAAAAA4D8AAAAAAADgPwAAAAAAAOA/AAAAAAAA4D8AAAAAAADgPwAAAAAAAOA/AAAAAAAA4D8CAAAAjAAAAAAAAAAAAAAAQoX0DP///wgAAAAAAAAAAAAAAAAAAAAAAAAAAAAAAAAAAAAAZAAAAAEAAABAAAAAAAAAAAAAAAAAAAAAAAAAAAAAAAAAAAAAAAAAAAAAAAAAAAAAAAAAAAAAAAAAAAAAAAAAAAAAAAAAAAAAAAAAAAAAAAAAAAAAAAAAAAAAAAAAAAAAFAAAADwAAAAAAAAAAAAAAAAAAAkUAAAAAQAAABQAAAAUAAAAFAAAAAEAAAAAAAAAZAAAAGQAAAAAAAAAZAAAAGQAAAAVAAAAYAAAAAAAAAAAAAAADwAAACADAAAAAAAAAAAAAAEAAACgMgAAVgcAAKr4//8BAAAAf39/AAEAAABkAAAAAAAAABQAAABAHwAAAAAAACYAAAAAAAAAwOD//wAAAAAmAAAAZAAAABYAAABMAAAAAAAAAAAAAAAEAAAAAAAAAAEAAABZWVkKAAAAACgAAAAoAAAAZAAAAGQAAAAAAAAAzMzMAAAAAABQAAAAUAAAAGQAAABkAAAAAAAAABcAAAAUAAAAAAAAAAAAAAD/fwAA/38AAAAAAAAJAAAABAAAACOP964eAAAAaAAAAAAAAAAAAAAAAAAAAAAAAAAAAAAAECcAABAnAAAAAAAAAAAAAAAAAAAAAAAAAAAAAAAAAAAAAAAAAAAAABQAAAAAAAAAwMD/AAAAAABkAAAAMgAAAAAAAABkAAAAAAAAAH9/fwAKAAAAIgAAABgAAAAAAAAAAAAAAAAAAAAAAAAAAAAAAAAAAAAkAAAAJAAAAAAAAAAHAAAAAAAAAAAAAAAAAAAAAAAAAAAAAAAAAAAAf39/ACUAAABYAAAAAAAAAAAAAAAAAAAAAAAAAAAAAAAAAAAAAAAAAAAAAAAAAAAAAAAAAAAAAAA/AAAAAAAAAKCGAQAAAAAAAAAAAAAAAAAMAAAAAQAAAAAAAAAAAAAAAAAAAB8AAABUAAAAAAAABQAAAAEAAAAAAAAAAAAAAAAAAAAAAAAAAAAAAAAAAAAAAAAAAAAAAAJ/f38AWVlZA8zMzADAwP8Af39/AAAAAAAAAAAAAAAAAAAAAAAAAAAAIQAAABgAAAAUAAAAFAMAALYCAAB/NwAAvwoAABAAAAAmAAAACAAAADwwAAAAAAAA"/>
+                <pr:smNativeData xmlns:pr="smNativeData" xmlns="smNativeData" val="SMDATA_15_FUV5ZhMAAAAlAAAAZAAAAA0AAAAAkAAAAJAAAACQAAAAkAAAAAAAAAAAAAAAAAAAAAEAAABQAAAAAAAAAAAA4D8AAAAAAADgPwAAAAAAAOA/AAAAAAAA4D8AAAAAAADgPwAAAAAAAOA/AAAAAAAA4D8AAAAAAADgPwAAAAAAAOA/AAAAAAAA4D8CAAAAjAAAAAAAAAAAAAAAQoX0DP///wgAAAAAAAAAAAAAAAAAAAAAAAAAAAAAAAAAAAAAZAAAAAEAAABAAAAAAAAAAAAAAAAAAAAAAAAAAAAAAAAAAAAAAAAAAAAAAAAAAAAAAAAAAAAAAAAAAAAAAAAAAAAAAAAAAAAAAAAAAAAAAAAAAAAAAAAAAAAAAAAAAAAAFAAAADwAAAAAAAAAAAAAAAAAAAkUAAAAAQAAABQAAAAUAAAAFAAAAAEAAAAAAAAAZAAAAGQAAAAAAAAAZAAAAGQAAAAVAAAAYAAAAAAAAAAAAAAADwAAACADAAAAAAAAAAAAAAEAAACgMgAAVgcAAKr4//8BAAAAf39/AAEAAABkAAAAAAAAABQAAABAHwAAAAAAACYAAAAAAAAAwOD//wAAAAAmAAAAZAAAABYAAABMAAAAAAAAAAAAAAAEAAAAAAAAAAEAAABZWVkKAAAAACgAAAAoAAAAZAAAAGQAAAAAAAAAzMzMAAAAAABQAAAAUAAAAGQAAABkAAAAAAAAABcAAAAUAAAAAAAAAAAAAAD/fwAA/38AAAAAAAAJAAAABAAAACOP964eAAAAaAAAAAAAAAAAAAAAAAAAAAAAAAAAAAAAECcAABAnAAAAAAAAAAAAAAAAAAAAAAAAAAAAAAAAAAAAAAAAAAAAABQAAAAAAAAAwMD/AAAAAABkAAAAMgAAAAAAAABkAAAAAAAAAH9/fwAKAAAAIgAAABgAAAAAAAAAAAAAAAAAAAAAAAAAAAAAAAAAAAAkAAAAJAAAAAAAAAAHAAAAAAAAAAAAAAAAAAAAAAAAAAAAAAAAAAAAf39/ACUAAABYAAAAAAAAAAAAAAAAAAAAAAAAAAAAAAAAAAAAAAAAAAAAAAAAAAAAAAAAAAAAAAA/AAAAAAAAAKCGAQAAAAAAAAAAAAAAAAAMAAAAAQAAAAAAAAAAAAAAAAAAAB8AAABUAAAAQoX0Bf///wEAAAAAAAAAAAAAAAAAAAAAAAAAAAAAAAAAAAAAAAAAAAAAAAJ/f38AWVlZA8zMzADAwP8Af39/AAAAAAAAAAAAAAAAAAAAAAAAAAAAIQAAABgAAAAUAAAAFAMAALYCAAB/NwAAvwoAABAAAAAmAAAACAAAADwwAAAAAAAA"/>
               </a:ext>
             </a:extLst>
           </p:cNvSpPr>
@@ -11879,7 +11879,7 @@
                 </a:tc>
                 <a:extLst>
                   <a:ext uri="smNativeData">
-                    <pr:rowheight xmlns="" xmlns:pr="smNativeData" dt="1719223342" type="min" val="381000"/>
+                    <pr:rowheight xmlns="" xmlns:pr="smNativeData" dt="1719223573" type="min" val="381000"/>
                   </a:ext>
                 </a:extLst>
               </a:tr>
@@ -12027,7 +12027,7 @@
                 </a:tc>
                 <a:extLst>
                   <a:ext uri="smNativeData">
-                    <pr:rowheight xmlns="" xmlns:pr="smNativeData" dt="1719223342" type="min" val="381000"/>
+                    <pr:rowheight xmlns="" xmlns:pr="smNativeData" dt="1719223573" type="min" val="381000"/>
                   </a:ext>
                 </a:extLst>
               </a:tr>
@@ -12175,7 +12175,7 @@
                 </a:tc>
                 <a:extLst>
                   <a:ext uri="smNativeData">
-                    <pr:rowheight xmlns="" xmlns:pr="smNativeData" dt="1719223342" type="min" val="381000"/>
+                    <pr:rowheight xmlns="" xmlns:pr="smNativeData" dt="1719223573" type="min" val="381000"/>
                   </a:ext>
                 </a:extLst>
               </a:tr>
@@ -12323,7 +12323,7 @@
                 </a:tc>
                 <a:extLst>
                   <a:ext uri="smNativeData">
-                    <pr:rowheight xmlns="" xmlns:pr="smNativeData" dt="1719223342" type="min" val="381000"/>
+                    <pr:rowheight xmlns="" xmlns:pr="smNativeData" dt="1719223573" type="min" val="381000"/>
                   </a:ext>
                 </a:extLst>
               </a:tr>
@@ -12337,7 +12337,7 @@
           <p:cNvSpPr>
             <a:extLst>
               <a:ext uri="smNativeData">
-                <pr:smNativeData xmlns:pr="smNativeData" xmlns="smNativeData" val="SMDATA_15_LkR5ZhMAAAAlAAAA9AEAAA0AAAAAOAEAAMYAAAA4AQAAxgAAAAAAAAABAAAAAAAAAAEAAABQAAAAe0ljtI6q2r8AAAAAAAD0PwAAAAAAAOA/AAAAAAAA4D8AAAAAAADgPwAAAAAAAOA/AAAAAAAA4D8AAAAAAADgPwAAAAAAAOA/AAAAAAAA4D8CAAAAjAAAAAEAAAAAAAAA8/PzAP///wgAAAAAAAAAAAAAAAAAAAAAAAAAAAAAAAAAAAAAeAAAAAEAAABAAAAAAAAAAAAAAABaAAAAAAAAAAAAAAAAAAAAAAAAAAAAAAAAAAAAAAAAAAAAAAAAAAAAAAAAAAAAAAAAAAAAAAAAAAAAAAAAAAAAAAAAAAAAAAAAAAAAFAAAADwAAAABAAAAAAAAAAE9hQAPAAAAAQAAACMAAAAjAAAAIwAAAB4AAAAAAAAASwAAAEsAAAAAAAAASwAAAEsAAAAVAAAAYAAAAAAAAAAAAAAADwAAACADAAAAAAAAAAAAAAEAAACgMgAAVgcAAKr4//8BAAAAf39/AAEAAABkAAAAAAAAABQAAABAHwAAAAAAACYAAAAAAAAAwOD//wAAAAAmAAAAZAAAABYAAABMAAAAAAAAAAAAAAAEAAAAAAAAAAEAAABZWVkKAAAAACgAAAAoAAAAZAAAAGQAAAAAAAAAzMzMAAAAAABQAAAAUAAAAGQAAABkAAAAAAAAABcAAAAUAAAAAAAAAAAAAAD/fwAA/38AAAAAAAAJAAAABAAAADpUCpYeAAAAaAAAAAAAAAAAAAAAAAAAAAAAAAAAAAAAECcAABAnAAAAAAAAAAAAAAAAAAAAAAAAAAAAAAAAAAAAAAAAAAAAABQAAAAAAAAAwMD/AAAAAABkAAAAMgAAAAAAAABkAAAAAAAAAH9/fwAKAAAAIgAAABgAAAAAAAAAAAAAAAAAAAAAAAAAAAAAAAAAAAAkAAAAJAAAAAAAAAAHAAAAAAAAAAAAAAAAAAAAAAAAAAAAAAAAAAAAf39/ACUAAABYAAAAAAAAAAAAAAAAAAAAAAAAAAAAAAAAAAAAAAAAAAAAAAAAAAAAAAAAAAAAAAA/AAAAAAAAAKCGAQAAAAAAAAAAAAAAAAAMAAAAAQAAAAAAAAAAAAAAAAAAAB8AAABUAAAA8/PzAP///wEAAAAAAAAAAAAAAAAAAAAAAAAAAAAAAAAAAAAAAAAAAAE9hQB/f38AWVlZA8zMzADAwP8Af39/AAAAAAAAAAAAAAAAAAAAAAAAAAAAIQAAABgAAAAUAAAA2CAAAFMCAADnNQAACwkAABAAAAAmAAAACAAAAP//////////"/>
+                <pr:smNativeData xmlns:pr="smNativeData" xmlns="smNativeData" val="SMDATA_15_FUV5ZhMAAAAlAAAA9AEAAA0AAAAAOAEAAMYAAAA4AQAAxgAAAAAAAAABAAAAAAAAAAEAAABQAAAAe0ljtI6q2r8AAAAAAAD0PwAAAAAAAOA/AAAAAAAA4D8AAAAAAADgPwAAAAAAAOA/AAAAAAAA4D8AAAAAAADgPwAAAAAAAOA/AAAAAAAA4D8CAAAAjAAAAAEAAAAAAAAA8/PzAP///wgAAAAAAAAAAAAAAAAAAAAAAAAAAAAAAAAAAAAAeAAAAAEAAABAAAAAAAAAAAAAAABaAAAAAAAAAAAAAAAAAAAAAAAAAAAAAAAAAAAAAAAAAAAAAAAAAAAAAAAAAAAAAAAAAAAAAAAAAAAAAAAAAAAAAAAAAAAAAAAAAAAAFAAAADwAAAABAAAAAAAAAAE9hQAPAAAAAQAAACMAAAAjAAAAIwAAAB4AAAAAAAAASwAAAEsAAAAAAAAASwAAAEsAAAAVAAAAYAAAAAAAAAAAAAAADwAAACADAAAAAAAAAAAAAAEAAACgMgAAVgcAAKr4//8BAAAAf39/AAEAAABkAAAAAAAAABQAAABAHwAAAAAAACYAAAAAAAAAwOD//wAAAAAmAAAAZAAAABYAAABMAAAAAAAAAAAAAAAEAAAAAAAAAAEAAABZWVkKAAAAACgAAAAoAAAAZAAAAGQAAAAAAAAAzMzMAAAAAABQAAAAUAAAAGQAAABkAAAAAAAAABcAAAAUAAAAAAAAAAAAAAD/fwAA/38AAAAAAAAJAAAABAAAADpUCpYeAAAAaAAAAAAAAAAAAAAAAAAAAAAAAAAAAAAAECcAABAnAAAAAAAAAAAAAAAAAAAAAAAAAAAAAAAAAAAAAAAAAAAAABQAAAAAAAAAwMD/AAAAAABkAAAAMgAAAAAAAABkAAAAAAAAAH9/fwAKAAAAIgAAABgAAAAAAAAAAAAAAAAAAAAAAAAAAAAAAAAAAAAkAAAAJAAAAAAAAAAHAAAAAAAAAAAAAAAAAAAAAAAAAAAAAAAAAAAAf39/ACUAAABYAAAAAAAAAAAAAAAAAAAAAAAAAAAAAAAAAAAAAAAAAAAAAAAAAAAAAAAAAAAAAAA/AAAAAAAAAKCGAQAAAAAAAAAAAAAAAAAMAAAAAQAAAAAAAAAAAAAAAAAAAB8AAABUAAAA8/PzAP///wEAAAAAAAAAAAAAAAAAAAAAAAAAAAAAAAAAAAAAAAAAAAE9hQB/f38AWVlZA8zMzADAwP8Af39/AAAAAAAAAAAAAAAAAAAAAAAAAAAAIQAAABgAAAAUAAAA2CAAAFMCAADnNQAACwkAABAAAAAmAAAACAAAAP//////////"/>
               </a:ext>
             </a:extLst>
           </p:cNvSpPr>
@@ -12441,7 +12441,7 @@
             <a:spLocks noGrp="1" noChangeArrowheads="1"/>
             <a:extLst>
               <a:ext uri="smNativeData">
-                <pr:smNativeData xmlns:pr="smNativeData" xmlns="smNativeData" val="SMDATA_15_LkR5ZhMAAAAlAAAAZAAAAA0AAAAAkAAAAJAAAACQAAAAkAAAAAAAAAAAAAAAAAAAAAEAAABQAAAAAAAAAAAA4D8AAAAAAADgPwAAAAAAAOA/AAAAAAAA4D8AAAAAAADgPwAAAAAAAOA/AAAAAAAA4D8AAAAAAADgPwAAAAAAAOA/AAAAAAAA4D8CAAAAjAAAAAAAAAAAAAAAQoX0DP///wgAAAAAAAAAAAAAAAAAAAAAAAAAAAAAAAAAAAAAZAAAAAEAAABAAAAAAAAAAAAAAAAAAAAAAAAAAAAAAAAAAAAAAAAAAAAAAAAAAAAAAAAAAAAAAAAAAAAAAAAAAAAAAAAAAAAAAAAAAAAAAAAAAAAAAAAAAAAAAAAAAAAAFAAAADwAAAAAAAAAAAAAAAAAAAkUAAAAAQAAABQAAAAUAAAAFAAAAAEAAAAAAAAAZAAAAGQAAAAAAAAAZAAAAGQAAAAVAAAAYAAAAAAAAAAAAAAADwAAACADAAAAAAAAAAAAAAEAAACgMgAAVgcAAKr4//8BAAAAf39/AAEAAABkAAAAAAAAABQAAABAHwAAAAAAACYAAAAAAAAAwOD//wAAAAAmAAAAZAAAABYAAABMAAAAAAAAAAAAAAAEAAAAAAAAAAEAAABZWVkKAAAAACgAAAAoAAAAZAAAAGQAAAAAAAAAzMzMAAAAAABQAAAAUAAAAGQAAABkAAAAAAAAABcAAAAUAAAAAAAAAAAAAAD/fwAA/38AAAAAAAAJAAAABAAAAGl3mg4eAAAAaAAAAAAAAAAAAAAAAAAAAAAAAAAAAAAAECcAABAnAAAAAAAAAAAAAAAAAAAAAAAAAAAAAAAAAAAAAAAAAAAAABQAAAAAAAAAwMD/AAAAAABkAAAAMgAAAAAAAABkAAAAAAAAAH9/fwAKAAAAIgAAABgAAAAAAAAAAAAAAAAAAAAAAAAAAAAAAAAAAAAkAAAAJAAAAAAAAAAHAAAAAAAAAAAAAAAAAAAAAAAAAAAAAAAAAAAAf39/ACUAAABYAAAAAAAAAAAAAAAAAAAAAAAAAAAAAAAAAAAAAAAAAAAAAAAAAAAAAAAAAAAAAAA/AAAAAAAAAKCGAQAAAAAAAAAAAAAAAAAMAAAAAQAAAAAAAAAAAAAAAAAAAB8AAABUAAAAAAAABQAAAAEAAAAAAAAAAAAAAAAAAAAAAAAAAAAAAAAAAAAAAAAAAAAAAAJ/f38AWVlZA8zMzADAwP8Af39/AAAAAAAAAAAAAAAAAAAAAAAAAAAAIQAAABgAAAAUAAAAFAMAALYCAAB/NwAAvwoAABAAAAAmAAAACAAAADwwAAAAAAAA"/>
+                <pr:smNativeData xmlns:pr="smNativeData" xmlns="smNativeData" val="SMDATA_15_FUV5ZhMAAAAlAAAAZAAAAA0AAAAAkAAAAJAAAACQAAAAkAAAAAAAAAAAAAAAAAAAAAEAAABQAAAAAAAAAAAA4D8AAAAAAADgPwAAAAAAAOA/AAAAAAAA4D8AAAAAAADgPwAAAAAAAOA/AAAAAAAA4D8AAAAAAADgPwAAAAAAAOA/AAAAAAAA4D8CAAAAjAAAAAAAAAAAAAAAQoX0DP///wgAAAAAAAAAAAAAAAAAAAAAAAAAAAAAAAAAAAAAZAAAAAEAAABAAAAAAAAAAAAAAAAAAAAAAAAAAAAAAAAAAAAAAAAAAAAAAAAAAAAAAAAAAAAAAAAAAAAAAAAAAAAAAAAAAAAAAAAAAAAAAAAAAAAAAAAAAAAAAAAAAAAAFAAAADwAAAAAAAAAAAAAAAAAAAkUAAAAAQAAABQAAAAUAAAAFAAAAAEAAAAAAAAAZAAAAGQAAAAAAAAAZAAAAGQAAAAVAAAAYAAAAAAAAAAAAAAADwAAACADAAAAAAAAAAAAAAEAAACgMgAAVgcAAKr4//8BAAAAf39/AAEAAABkAAAAAAAAABQAAABAHwAAAAAAACYAAAAAAAAAwOD//wAAAAAmAAAAZAAAABYAAABMAAAAAAAAAAAAAAAEAAAAAAAAAAEAAABZWVkKAAAAACgAAAAoAAAAZAAAAGQAAAAAAAAAzMzMAAAAAABQAAAAUAAAAGQAAABkAAAAAAAAABcAAAAUAAAAAAAAAAAAAAD/fwAA/38AAAAAAAAJAAAABAAAAGl3mg4eAAAAaAAAAAAAAAAAAAAAAAAAAAAAAAAAAAAAECcAABAnAAAAAAAAAAAAAAAAAAAAAAAAAAAAAAAAAAAAAAAAAAAAABQAAAAAAAAAwMD/AAAAAABkAAAAMgAAAAAAAABkAAAAAAAAAH9/fwAKAAAAIgAAABgAAAAAAAAAAAAAAAAAAAAAAAAAAAAAAAAAAAAkAAAAJAAAAAAAAAAHAAAAAAAAAAAAAAAAAAAAAAAAAAAAAAAAAAAAf39/ACUAAABYAAAAAAAAAAAAAAAAAAAAAAAAAAAAAAAAAAAAAAAAAAAAAAAAAAAAAAAAAAAAAAA/AAAAAAAAAKCGAQAAAAAAAAAAAAAAAAAMAAAAAQAAAAAAAAAAAAAAAAAAAB8AAABUAAAAQoX0Bf///wEAAAAAAAAAAAAAAAAAAAAAAAAAAAAAAAAAAAAAAAAAAAAAAAJ/f38AWVlZA8zMzADAwP8Af39/AAAAAAAAAAAAAAAAAAAAAAAAAAAAIQAAABgAAAAUAAAAFAMAALYCAAB/NwAAvwoAABAAAAAmAAAACAAAADwwAAAAAAAA"/>
               </a:ext>
             </a:extLst>
           </p:cNvSpPr>
@@ -12631,7 +12631,7 @@
                 </a:tc>
                 <a:extLst>
                   <a:ext uri="smNativeData">
-                    <pr:rowheight xmlns="" xmlns:pr="smNativeData" dt="1719223342" type="min" val="381000"/>
+                    <pr:rowheight xmlns="" xmlns:pr="smNativeData" dt="1719223573" type="min" val="381000"/>
                   </a:ext>
                 </a:extLst>
               </a:tr>
@@ -12779,7 +12779,7 @@
                 </a:tc>
                 <a:extLst>
                   <a:ext uri="smNativeData">
-                    <pr:rowheight xmlns="" xmlns:pr="smNativeData" dt="1719223342" type="min" val="381000"/>
+                    <pr:rowheight xmlns="" xmlns:pr="smNativeData" dt="1719223573" type="min" val="381000"/>
                   </a:ext>
                 </a:extLst>
               </a:tr>
@@ -12927,7 +12927,7 @@
                 </a:tc>
                 <a:extLst>
                   <a:ext uri="smNativeData">
-                    <pr:rowheight xmlns="" xmlns:pr="smNativeData" dt="1719223342" type="min" val="381000"/>
+                    <pr:rowheight xmlns="" xmlns:pr="smNativeData" dt="1719223573" type="min" val="381000"/>
                   </a:ext>
                 </a:extLst>
               </a:tr>
@@ -13067,7 +13067,7 @@
                 </a:tc>
                 <a:extLst>
                   <a:ext uri="smNativeData">
-                    <pr:rowheight xmlns="" xmlns:pr="smNativeData" dt="1719223342" type="min" val="381000"/>
+                    <pr:rowheight xmlns="" xmlns:pr="smNativeData" dt="1719223573" type="min" val="381000"/>
                   </a:ext>
                 </a:extLst>
               </a:tr>
@@ -13081,7 +13081,7 @@
           <p:cNvSpPr>
             <a:extLst>
               <a:ext uri="smNativeData">
-                <pr:smNativeData xmlns:pr="smNativeData" xmlns="smNativeData" val="SMDATA_15_LkR5ZhMAAAAlAAAA9AEAAA0AAAAAOAEAAMYAAAA4AQAAxgAAAAAAAAABAAAAAAAAAAEAAABQAAAAe0ljtI6q2r8AAAAAAAD0PwAAAAAAAOA/AAAAAAAA4D8AAAAAAADgPwAAAAAAAOA/AAAAAAAA4D8AAAAAAADgPwAAAAAAAOA/AAAAAAAA4D8CAAAAjAAAAAEAAAAAAAAA8/PzAP///wgAAAAAAAAAAAAAAAAAAAAAAAAAAAAAAAAAAAAAeAAAAAEAAABAAAAAAAAAAAAAAABaAAAAAAAAAAAAAAAAAAAAAAAAAAAAAAAAAAAAAAAAAAAAAAAAAAAAAAAAAAAAAAAAAAAAAAAAAAAAAAAAAAAAAAAAAAAAAAAAAAAAFAAAADwAAAABAAAAAAAAAAE9hQAPAAAAAQAAACMAAAAjAAAAIwAAAB4AAAAAAAAASwAAAEsAAAAAAAAASwAAAEsAAAAVAAAAYAAAAAAAAAAAAAAADwAAACADAAAAAAAAAAAAAAEAAACgMgAAVgcAAKr4//8BAAAAf39/AAEAAABkAAAAAAAAABQAAABAHwAAAAAAACYAAAAAAAAAwOD//wAAAAAmAAAAZAAAABYAAABMAAAAAAAAAAAAAAAEAAAAAAAAAAEAAABZWVkKAAAAACgAAAAoAAAAZAAAAGQAAAAAAAAAzMzMAAAAAABQAAAAUAAAAGQAAABkAAAAAAAAABcAAAAUAAAAAAAAAAAAAAD/fwAA/38AAAAAAAAJAAAABAAAACgVFOgeAAAAaAAAAAAAAAAAAAAAAAAAAAAAAAAAAAAAECcAABAnAAAAAAAAAAAAAAAAAAAAAAAAAAAAAAAAAAAAAAAAAAAAABQAAAAAAAAAwMD/AAAAAABkAAAAMgAAAAAAAABkAAAAAAAAAH9/fwAKAAAAIgAAABgAAAAAAAAAAAAAAAAAAAAAAAAAAAAAAAAAAAAkAAAAJAAAAAAAAAAHAAAAAAAAAAAAAAAAAAAAAAAAAAAAAAAAAAAAf39/ACUAAABYAAAAAAAAAAAAAAAAAAAAAAAAAAAAAAAAAAAAAAAAAAAAAAAAAAAAAAAAAAAAAAA/AAAAAAAAAKCGAQAAAAAAAAAAAAAAAAAMAAAAAQAAAAAAAAAAAAAAAAAAAB8AAABUAAAA8/PzAP///wEAAAAAAAAAAAAAAAAAAAAAAAAAAAAAAAAAAAAAAAAAAAE9hQB/f38AWVlZA8zMzADAwP8Af39/AAAAAAAAAAAAAAAAAAAAAAAAAAAAIQAAABgAAAAUAAAA2CAAAFMCAADnNQAACwkAABAAAAAmAAAACAAAAP//////////"/>
+                <pr:smNativeData xmlns:pr="smNativeData" xmlns="smNativeData" val="SMDATA_15_FUV5ZhMAAAAlAAAA9AEAAA0AAAAAOAEAAMYAAAA4AQAAxgAAAAAAAAABAAAAAAAAAAEAAABQAAAAe0ljtI6q2r8AAAAAAAD0PwAAAAAAAOA/AAAAAAAA4D8AAAAAAADgPwAAAAAAAOA/AAAAAAAA4D8AAAAAAADgPwAAAAAAAOA/AAAAAAAA4D8CAAAAjAAAAAEAAAAAAAAA8/PzAP///wgAAAAAAAAAAAAAAAAAAAAAAAAAAAAAAAAAAAAAeAAAAAEAAABAAAAAAAAAAAAAAABaAAAAAAAAAAAAAAAAAAAAAAAAAAAAAAAAAAAAAAAAAAAAAAAAAAAAAAAAAAAAAAAAAAAAAAAAAAAAAAAAAAAAAAAAAAAAAAAAAAAAFAAAADwAAAABAAAAAAAAAAE9hQAPAAAAAQAAACMAAAAjAAAAIwAAAB4AAAAAAAAASwAAAEsAAAAAAAAASwAAAEsAAAAVAAAAYAAAAAAAAAAAAAAADwAAACADAAAAAAAAAAAAAAEAAACgMgAAVgcAAKr4//8BAAAAf39/AAEAAABkAAAAAAAAABQAAABAHwAAAAAAACYAAAAAAAAAwOD//wAAAAAmAAAAZAAAABYAAABMAAAAAAAAAAAAAAAEAAAAAAAAAAEAAABZWVkKAAAAACgAAAAoAAAAZAAAAGQAAAAAAAAAzMzMAAAAAABQAAAAUAAAAGQAAABkAAAAAAAAABcAAAAUAAAAAAAAAAAAAAD/fwAA/38AAAAAAAAJAAAABAAAACgVFOgeAAAAaAAAAAAAAAAAAAAAAAAAAAAAAAAAAAAAECcAABAnAAAAAAAAAAAAAAAAAAAAAAAAAAAAAAAAAAAAAAAAAAAAABQAAAAAAAAAwMD/AAAAAABkAAAAMgAAAAAAAABkAAAAAAAAAH9/fwAKAAAAIgAAABgAAAAAAAAAAAAAAAAAAAAAAAAAAAAAAAAAAAAkAAAAJAAAAAAAAAAHAAAAAAAAAAAAAAAAAAAAAAAAAAAAAAAAAAAAf39/ACUAAABYAAAAAAAAAAAAAAAAAAAAAAAAAAAAAAAAAAAAAAAAAAAAAAAAAAAAAAAAAAAAAAA/AAAAAAAAAKCGAQAAAAAAAAAAAAAAAAAMAAAAAQAAAAAAAAAAAAAAAAAAAB8AAABUAAAA8/PzAP///wEAAAAAAAAAAAAAAAAAAAAAAAAAAAAAAAAAAAAAAAAAAAE9hQB/f38AWVlZA8zMzADAwP8Af39/AAAAAAAAAAAAAAAAAAAAAAAAAAAAIQAAABgAAAAUAAAA2CAAAFMCAADnNQAACwkAABAAAAAmAAAACAAAAP//////////"/>
               </a:ext>
             </a:extLst>
           </p:cNvSpPr>
@@ -13185,7 +13185,7 @@
             <a:spLocks noGrp="1" noChangeArrowheads="1"/>
             <a:extLst>
               <a:ext uri="smNativeData">
-                <pr:smNativeData xmlns:pr="smNativeData" xmlns="smNativeData" val="SMDATA_15_LkR5ZhMAAAAlAAAAZAAAAA0AAAAAkAAAAJAAAACQAAAAkAAAAAAAAAAAAAAAAAAAAAEAAABQAAAAAAAAAAAA4D8AAAAAAADgPwAAAAAAAOA/AAAAAAAA4D8AAAAAAADgPwAAAAAAAOA/AAAAAAAA4D8AAAAAAADgPwAAAAAAAOA/AAAAAAAA4D8CAAAAjAAAAAAAAAAAAAAAQoX0DP///wgAAAAAAAAAAAAAAAAAAAAAAAAAAAAAAAAAAAAAZAAAAAEAAABAAAAAAAAAAAAAAAAAAAAAAAAAAAAAAAAAAAAAAAAAAAAAAAAAAAAAAAAAAAAAAAAAAAAAAAAAAAAAAAAAAAAAAAAAAAAAAAAAAAAAAAAAAAAAAAAAAAAAFAAAADwAAAAAAAAAAAAAAAAAAAkUAAAAAQAAABQAAAAUAAAAFAAAAAEAAAAAAAAAZAAAAGQAAAAAAAAAZAAAAGQAAAAVAAAAYAAAAAAAAAAAAAAADwAAACADAAAAAAAAAAAAAAEAAACgMgAAVgcAAKr4//8BAAAAf39/AAEAAABkAAAAAAAAABQAAABAHwAAAAAAACYAAAAAAAAAwOD//wAAAAAmAAAAZAAAABYAAABMAAAAAAAAAAAAAAAEAAAAAAAAAAEAAABZWVkKAAAAACgAAAAoAAAAZAAAAGQAAAAAAAAAzMzMAAAAAABQAAAAUAAAAGQAAABkAAAAAAAAABcAAAAUAAAAAAAAAAAAAAD/fwAA/38AAAAAAAAJAAAABAAAAMeGczoeAAAAaAAAAAAAAAAAAAAAAAAAAAAAAAAAAAAAECcAABAnAAAAAAAAAAAAAAAAAAAAAAAAAAAAAAAAAAAAAAAAAAAAABQAAAAAAAAAwMD/AAAAAABkAAAAMgAAAAAAAABkAAAAAAAAAH9/fwAKAAAAIgAAABgAAAAAAAAAAAAAAAAAAAAAAAAAAAAAAAAAAAAkAAAAJAAAAAAAAAAHAAAAAAAAAAAAAAAAAAAAAAAAAAAAAAAAAAAAf39/ACUAAABYAAAAAAAAAAAAAAAAAAAAAAAAAAAAAAAAAAAAAAAAAAAAAAAAAAAAAAAAAAAAAAA/AAAAAAAAAKCGAQAAAAAAAAAAAAAAAAAMAAAAAQAAAAAAAAAAAAAAAAAAAB8AAABUAAAAAAAABQAAAAEAAAAAAAAAAAAAAAAAAAAAAAAAAAAAAAAAAAAAAAAAAAAAAAJ/f38AWVlZA8zMzADAwP8Af39/AAAAAAAAAAAAAAAAAAAAAAAAAAAAIQAAABgAAAAUAAAAFAMAALYCAAB/NwAAvwoAABAAAAAmAAAACAAAADwwAAAAAAAA"/>
+                <pr:smNativeData xmlns:pr="smNativeData" xmlns="smNativeData" val="SMDATA_15_FUV5ZhMAAAAlAAAAZAAAAA0AAAAAkAAAAJAAAACQAAAAkAAAAAAAAAAAAAAAAAAAAAEAAABQAAAAAAAAAAAA4D8AAAAAAADgPwAAAAAAAOA/AAAAAAAA4D8AAAAAAADgPwAAAAAAAOA/AAAAAAAA4D8AAAAAAADgPwAAAAAAAOA/AAAAAAAA4D8CAAAAjAAAAAAAAAAAAAAAQoX0DP///wgAAAAAAAAAAAAAAAAAAAAAAAAAAAAAAAAAAAAAZAAAAAEAAABAAAAAAAAAAAAAAAAAAAAAAAAAAAAAAAAAAAAAAAAAAAAAAAAAAAAAAAAAAAAAAAAAAAAAAAAAAAAAAAAAAAAAAAAAAAAAAAAAAAAAAAAAAAAAAAAAAAAAFAAAADwAAAAAAAAAAAAAAAAAAAkUAAAAAQAAABQAAAAUAAAAFAAAAAEAAAAAAAAAZAAAAGQAAAAAAAAAZAAAAGQAAAAVAAAAYAAAAAAAAAAAAAAADwAAACADAAAAAAAAAAAAAAEAAACgMgAAVgcAAKr4//8BAAAAf39/AAEAAABkAAAAAAAAABQAAABAHwAAAAAAACYAAAAAAAAAwOD//wAAAAAmAAAAZAAAABYAAABMAAAAAAAAAAAAAAAEAAAAAAAAAAEAAABZWVkKAAAAACgAAAAoAAAAZAAAAGQAAAAAAAAAzMzMAAAAAABQAAAAUAAAAGQAAABkAAAAAAAAABcAAAAUAAAAAAAAAAAAAAD/fwAA/38AAAAAAAAJAAAABAAAAMeGczoeAAAAaAAAAAAAAAAAAAAAAAAAAAAAAAAAAAAAECcAABAnAAAAAAAAAAAAAAAAAAAAAAAAAAAAAAAAAAAAAAAAAAAAABQAAAAAAAAAwMD/AAAAAABkAAAAMgAAAAAAAABkAAAAAAAAAH9/fwAKAAAAIgAAABgAAAAAAAAAAAAAAAAAAAAAAAAAAAAAAAAAAAAkAAAAJAAAAAAAAAAHAAAAAAAAAAAAAAAAAAAAAAAAAAAAAAAAAAAAf39/ACUAAABYAAAAAAAAAAAAAAAAAAAAAAAAAAAAAAAAAAAAAAAAAAAAAAAAAAAAAAAAAAAAAAA/AAAAAAAAAKCGAQAAAAAAAAAAAAAAAAAMAAAAAQAAAAAAAAAAAAAAAAAAAB8AAABUAAAAQoX0Bf///wEAAAAAAAAAAAAAAAAAAAAAAAAAAAAAAAAAAAAAAAAAAAAAAAJ/f38AWVlZA8zMzADAwP8Af39/AAAAAAAAAAAAAAAAAAAAAAAAAAAAIQAAABgAAAAUAAAAFAMAALYCAAB/NwAAvwoAABAAAAAmAAAACAAAADwwAAAAAAAA"/>
               </a:ext>
             </a:extLst>
           </p:cNvSpPr>
@@ -13375,7 +13375,7 @@
                 </a:tc>
                 <a:extLst>
                   <a:ext uri="smNativeData">
-                    <pr:rowheight xmlns="" xmlns:pr="smNativeData" dt="1719223342" type="min" val="381000"/>
+                    <pr:rowheight xmlns="" xmlns:pr="smNativeData" dt="1719223573" type="min" val="381000"/>
                   </a:ext>
                 </a:extLst>
               </a:tr>
@@ -13523,7 +13523,7 @@
                 </a:tc>
                 <a:extLst>
                   <a:ext uri="smNativeData">
-                    <pr:rowheight xmlns="" xmlns:pr="smNativeData" dt="1719223342" type="min" val="381000"/>
+                    <pr:rowheight xmlns="" xmlns:pr="smNativeData" dt="1719223573" type="min" val="381000"/>
                   </a:ext>
                 </a:extLst>
               </a:tr>
@@ -13663,7 +13663,7 @@
                 </a:tc>
                 <a:extLst>
                   <a:ext uri="smNativeData">
-                    <pr:rowheight xmlns="" xmlns:pr="smNativeData" dt="1719223342" type="min" val="381000"/>
+                    <pr:rowheight xmlns="" xmlns:pr="smNativeData" dt="1719223573" type="min" val="381000"/>
                   </a:ext>
                 </a:extLst>
               </a:tr>
@@ -13677,7 +13677,7 @@
           <p:cNvSpPr>
             <a:extLst>
               <a:ext uri="smNativeData">
-                <pr:smNativeData xmlns:pr="smNativeData" xmlns="smNativeData" val="SMDATA_15_LkR5ZhMAAAAlAAAA9AEAAA0AAAAAOAEAAMYAAAA4AQAAxgAAAAAAAAABAAAAAAAAAAEAAABQAAAAR+aRPxh47L8Gu2Hbosz8vwAAAAAAAOA/AAAAAAAA4D8AAAAAAADgPwAAAAAAAOA/AAAAAAAA4D8AAAAAAADgPwAAAAAAAOA/AAAAAAAA4D8CAAAAjAAAAAEAAAAAAAAA8/PzAP///wgAAAAAAAAAAAAAAAAAAAAAAAAAAAAAAAAAAAAAeAAAAAEAAABAAAAAAAAAAAAAAABaAAAAAAAAAAAAAAAAAAAAAAAAAAAAAAAAAAAAAAAAAAAAAAAAAAAAAAAAAAAAAAAAAAAAAAAAAAAAAAAAAAAAAAAAAAAAAAAAAAAAFAAAADwAAAABAAAAAAAAAAE9hQAPAAAAAQAAACMAAAAjAAAAIwAAAB4AAAAAAAAASwAAAEsAAAAAAAAASwAAAEsAAAAVAAAAYAAAAAAAAAAAAAAADwAAACADAAAAAAAAAAAAAAEAAACgMgAAVgcAAKr4//8BAAAAf39/AAEAAABkAAAAAAAAABQAAABAHwAAAAAAACYAAAAAAAAAwOD//wAAAAAmAAAAZAAAABYAAABMAAAAAAAAAAAAAAAEAAAAAAAAAAEAAABZWVkKAAAAACgAAAAoAAAAZAAAAGQAAAAAAAAAzMzMAAAAAABQAAAAUAAAAGQAAABkAAAAAAAAABcAAAAUAAAAAAAAAAAAAAD/fwAA/38AAAAAAAAJAAAABAAAAAECAwAeAAAAaAAAAAAAAAAAAAAAAAAAAAAAAAAAAAAAECcAABAnAAAAAAAAAAAAAAAAAAAAAAAAAAAAAAAAAAAAAAAAAAAAABQAAAAAAAAAwMD/AAAAAABkAAAAMgAAAAAAAABkAAAAAAAAAH9/fwAKAAAAIgAAABgAAAAAAAAAAAAAAAAAAAAAAAAAAAAAAAAAAAAkAAAAJAAAAAAAAAAHAAAAAAAAAAAAAAAAAAAAAAAAAAAAAAAAAAAAf39/ACUAAABYAAAAAAAAAAAAAAAAAAAAAAAAAAAAAAAAAAAAAAAAAAAAAAAAAAAAAAAAAAAAAAA/AAAAAAAAAKCGAQAAAAAAAAAAAAAAAAAMAAAAAQAAAAAAAAAAAAAAAAAAAB8AAABUAAAA8/PzAP///wEAAAAAAAAAAAAAAAAAAAAAAAAAAAAAAAAAAAAAAAAAAAE9hQB/f38AWVlZA8zMzADAwP8Af39/AAAAAAAAAAAAAAAAAAAAAAAAAAAAIQAAABgAAAAUAAAAVR0AALMbAABkMgAAaiIAABAAAAAmAAAACAAAAP//////////"/>
+                <pr:smNativeData xmlns:pr="smNativeData" xmlns="smNativeData" val="SMDATA_15_FUV5ZhMAAAAlAAAA9AEAAA0AAAAAOAEAAMYAAAA4AQAAxgAAAAAAAAABAAAAAAAAAAEAAABQAAAAR+aRPxh47L8Gu2Hbosz8vwAAAAAAAOA/AAAAAAAA4D8AAAAAAADgPwAAAAAAAOA/AAAAAAAA4D8AAAAAAADgPwAAAAAAAOA/AAAAAAAA4D8CAAAAjAAAAAEAAAAAAAAA8/PzAP///wgAAAAAAAAAAAAAAAAAAAAAAAAAAAAAAAAAAAAAeAAAAAEAAABAAAAAAAAAAAAAAABaAAAAAAAAAAAAAAAAAAAAAAAAAAAAAAAAAAAAAAAAAAAAAAAAAAAAAAAAAAAAAAAAAAAAAAAAAAAAAAAAAAAAAAAAAAAAAAAAAAAAFAAAADwAAAABAAAAAAAAAAE9hQAPAAAAAQAAACMAAAAjAAAAIwAAAB4AAAAAAAAASwAAAEsAAAAAAAAASwAAAEsAAAAVAAAAYAAAAAAAAAAAAAAADwAAACADAAAAAAAAAAAAAAEAAACgMgAAVgcAAKr4//8BAAAAf39/AAEAAABkAAAAAAAAABQAAABAHwAAAAAAACYAAAAAAAAAwOD//wAAAAAmAAAAZAAAABYAAABMAAAAAAAAAAAAAAAEAAAAAAAAAAEAAABZWVkKAAAAACgAAAAoAAAAZAAAAGQAAAAAAAAAzMzMAAAAAABQAAAAUAAAAGQAAABkAAAAAAAAABcAAAAUAAAAAAAAAAAAAAD/fwAA/38AAAAAAAAJAAAABAAAAAECAwAeAAAAaAAAAAAAAAAAAAAAAAAAAAAAAAAAAAAAECcAABAnAAAAAAAAAAAAAAAAAAAAAAAAAAAAAAAAAAAAAAAAAAAAABQAAAAAAAAAwMD/AAAAAABkAAAAMgAAAAAAAABkAAAAAAAAAH9/fwAKAAAAIgAAABgAAAAAAAAAAAAAAAAAAAAAAAAAAAAAAAAAAAAkAAAAJAAAAAAAAAAHAAAAAAAAAAAAAAAAAAAAAAAAAAAAAAAAAAAAf39/ACUAAABYAAAAAAAAAAAAAAAAAAAAAAAAAAAAAAAAAAAAAAAAAAAAAAAAAAAAAAAAAAAAAAA/AAAAAAAAAKCGAQAAAAAAAAAAAAAAAAAMAAAAAQAAAAAAAAAAAAAAAAAAAB8AAABUAAAA8/PzAP///wEAAAAAAAAAAAAAAAAAAAAAAAAAAAAAAAAAAAAAAAAAAAE9hQB/f38AWVlZA8zMzADAwP8Af39/AAAAAAAAAAAAAAAAAAAAAAAAAAAAIQAAABgAAAAUAAAAVR0AALMbAABkMgAAaiIAABAAAAAmAAAACAAAAP//////////"/>
               </a:ext>
             </a:extLst>
           </p:cNvSpPr>
@@ -13781,7 +13781,7 @@
             <a:spLocks noGrp="1" noChangeArrowheads="1"/>
             <a:extLst>
               <a:ext uri="smNativeData">
-                <pr:smNativeData xmlns:pr="smNativeData" xmlns="smNativeData" val="SMDATA_15_LkR5ZhMAAAAlAAAAZAAAAA0AAAAAkAAAAJAAAACQAAAAkAAAAAAAAAAAAAAAAAAAAAEAAABQAAAAAAAAAAAA4D8AAAAAAADgPwAAAAAAAOA/AAAAAAAA4D8AAAAAAADgPwAAAAAAAOA/AAAAAAAA4D8AAAAAAADgPwAAAAAAAOA/AAAAAAAA4D8CAAAAjAAAAAAAAAAAAAAAQoX0DP///wgAAAAAAAAAAAAAAAAAAAAAAAAAAAAAAAAAAAAAZAAAAAEAAABAAAAAAAAAAAAAAAAAAAAAAAAAAAAAAAAAAAAAAAAAAAAAAAAAAAAAAAAAAAAAAAAAAAAAAAAAAAAAAAAAAAAAAAAAAAAAAAAAAAAAAAAAAAAAAAAAAAAAFAAAADwAAAAAAAAAAAAAAAAAAAkUAAAAAQAAABQAAAAUAAAAFAAAAAEAAAAAAAAAZAAAAGQAAAAAAAAAZAAAAGQAAAAVAAAAYAAAAAAAAAAAAAAADwAAACADAAAAAAAAAAAAAAEAAACgMgAAVgcAAKr4//8BAAAAf39/AAEAAABkAAAAAAAAABQAAABAHwAAAAAAACYAAAAAAAAAwOD//wAAAAAmAAAAZAAAABYAAABMAAAAAAAAAAAAAAAEAAAAAAAAAAEAAABZWVkKAAAAACgAAAAoAAAAZAAAAGQAAAAAAAAAzMzMAAAAAABQAAAAUAAAAGQAAABkAAAAAAAAABcAAAAUAAAAAAAAAAAAAAD/fwAA/38AAAAAAAAJAAAABAAAAGDhtuMeAAAAaAAAAAAAAAAAAAAAAAAAAAAAAAAAAAAAECcAABAnAAAAAAAAAAAAAAAAAAAAAAAAAAAAAAAAAAAAAAAAAAAAABQAAAAAAAAAwMD/AAAAAABkAAAAMgAAAAAAAABkAAAAAAAAAH9/fwAKAAAAIgAAABgAAAAAAAAAAAAAAAAAAAAAAAAAAAAAAAAAAAAkAAAAJAAAAAAAAAAHAAAAAAAAAAAAAAAAAAAAAAAAAAAAAAAAAAAAf39/ACUAAABYAAAAAAAAAAAAAAAAAAAAAAAAAAAAAAAAAAAAAAAAAAAAAAAAAAAAAAAAAAAAAAA/AAAAAAAAAKCGAQAAAAAAAAAAAAAAAAAMAAAAAQAAAAAAAAAAAAAAAAAAAB8AAABUAAAAAAAABQAAAAEAAAAAAAAAAAAAAAAAAAAAAAAAAAAAAAAAAAAAAAAAAAAAAAJ/f38AWVlZA8zMzADAwP8Af39/AAAAAAAAAAAAAAAAAAAAAAAAAAAAIQAAABgAAAAUAAAAFAMAALYCAAB/NwAAvwoAABAAAAAmAAAACAAAADwwAAAAAAAA"/>
+                <pr:smNativeData xmlns:pr="smNativeData" xmlns="smNativeData" val="SMDATA_15_FUV5ZhMAAAAlAAAAZAAAAA0AAAAAkAAAAJAAAACQAAAAkAAAAAAAAAAAAAAAAAAAAAEAAABQAAAAAAAAAAAA4D8AAAAAAADgPwAAAAAAAOA/AAAAAAAA4D8AAAAAAADgPwAAAAAAAOA/AAAAAAAA4D8AAAAAAADgPwAAAAAAAOA/AAAAAAAA4D8CAAAAjAAAAAAAAAAAAAAAQoX0DP///wgAAAAAAAAAAAAAAAAAAAAAAAAAAAAAAAAAAAAAZAAAAAEAAABAAAAAAAAAAAAAAAAAAAAAAAAAAAAAAAAAAAAAAAAAAAAAAAAAAAAAAAAAAAAAAAAAAAAAAAAAAAAAAAAAAAAAAAAAAAAAAAAAAAAAAAAAAAAAAAAAAAAAFAAAADwAAAAAAAAAAAAAAAAAAAkUAAAAAQAAABQAAAAUAAAAFAAAAAEAAAAAAAAAZAAAAGQAAAAAAAAAZAAAAGQAAAAVAAAAYAAAAAAAAAAAAAAADwAAACADAAAAAAAAAAAAAAEAAACgMgAAVgcAAKr4//8BAAAAf39/AAEAAABkAAAAAAAAABQAAABAHwAAAAAAACYAAAAAAAAAwOD//wAAAAAmAAAAZAAAABYAAABMAAAAAAAAAAAAAAAEAAAAAAAAAAEAAABZWVkKAAAAACgAAAAoAAAAZAAAAGQAAAAAAAAAzMzMAAAAAABQAAAAUAAAAGQAAABkAAAAAAAAABcAAAAUAAAAAAAAAAAAAAD/fwAA/38AAAAAAAAJAAAABAAAAGDhtuMeAAAAaAAAAAAAAAAAAAAAAAAAAAAAAAAAAAAAECcAABAnAAAAAAAAAAAAAAAAAAAAAAAAAAAAAAAAAAAAAAAAAAAAABQAAAAAAAAAwMD/AAAAAABkAAAAMgAAAAAAAABkAAAAAAAAAH9/fwAKAAAAIgAAABgAAAAAAAAAAAAAAAAAAAAAAAAAAAAAAAAAAAAkAAAAJAAAAAAAAAAHAAAAAAAAAAAAAAAAAAAAAAAAAAAAAAAAAAAAf39/ACUAAABYAAAAAAAAAAAAAAAAAAAAAAAAAAAAAAAAAAAAAAAAAAAAAAAAAAAAAAAAAAAAAAA/AAAAAAAAAKCGAQAAAAAAAAAAAAAAAAAMAAAAAQAAAAAAAAAAAAAAAAAAAB8AAABUAAAAAAAABQAAAAEAAAAAAAAAAAAAAAAAAAAAAAAAAAAAAAAAAAAAAAAAAAAAAAJ/f38AWVlZA8zMzADAwP8Af39/AAAAAAAAAAAAAAAAAAAAAAAAAAAAIQAAABgAAAAUAAAAFAMAALYCAAB/NwAAvwoAABAAAAAmAAAACAAAADwwAAAAAAAA"/>
               </a:ext>
             </a:extLst>
           </p:cNvSpPr>
@@ -13824,7 +13824,7 @@
             <a:spLocks noGrp="1" noChangeArrowheads="1"/>
             <a:extLst>
               <a:ext uri="smNativeData">
-                <pr:smNativeData xmlns:pr="smNativeData" xmlns="smNativeData" val="SMDATA_15_LkR5ZhMAAAAlAAAAZAAAAA0AAAAAkAAAAJAAAACQAAAAkAAAAAAAAAAAAAAAAAAAAAEAAABQAAAAAAAAAAAA4D8AAAAAAADgPwAAAAAAAOA/AAAAAAAA4D8AAAAAAADgPwAAAAAAAOA/AAAAAAAA4D8AAAAAAADgPwAAAAAAAOA/AAAAAAAA4D8CAAAAjAAAAAAAAAAAAAAAQoX0DP///wgAAAAAAAAAAAAAAAAAAAAAAAAAAAAAAAAAAAAAZAAAAAEAAABAAAAAAAAAAAAAAAAAAAAAAAAAAAAAAAAAAAAAAAAAAAAAAAAAAAAAAAAAAAAAAAAAAAAAAAAAAAAAAAAAAAAAAAAAAAAAAAAAAAAAAAAAAAAAAAAAAAAAFAAAADwAAAAAAAAAAAAAAAAAAAkUAAAAAQAAABQAAAAUAAAAFAAAAAEAAAAAAAAAZAAAAGQAAAAAAAAAZAAAAGQAAAAVAAAAYAAAAAAAAAAAAAAADwAAACADAAAAAAAAAAAAAAEAAACgMgAAVgcAAKr4//8BAAAAf39/AAEAAABkAAAAAAAAABQAAABAHwAAAAAAACYAAAAAAAAAwOD//wAAAAAmAAAAZAAAABYAAABMAAAAAAAAAAAAAAAEAAAAAAAAAAEAAABZWVkKAAAAACgAAAAoAAAAZAAAAGQAAAAAAAAAzMzMAAAAAABQAAAAUAAAAGQAAABkAAAAAAAAABcAAAAUAAAAAAAAAAAAAAD/fwAA/38AAAAAAAAJAAAABAAAAF8AYAAeAAAAaAAAAAAAAAAAAAAAAAAAAAAAAAAAAAAAECcAABAnAAAAAAAAAAAAAAAAAAAAAAAAAAAAAAAAAAAAAAAAAAAAABQAAAAAAAAAwMD/AAAAAABkAAAAMgAAAAAAAABkAAAAAAAAAH9/fwAKAAAAIgAAABgAAAAAAAAAAAAAAAAAAAAAAAAAAAAAAAAAAAAkAAAAJAAAAAAAAAAHAAAAAAAAAAAAAAAAAAAAAAAAAAAAAAAAAAAAf39/ACUAAABYAAAAAAAAAAAAAAAAAAAAAAAAAAAAAAAAAAAAAAAAAAAAAAAAAAAAAAAAAAAAAAA/AAAAAAAAAKCGAQAAAAAAAAAAAAAAAAAMAAAAAQAAAAAAAAAAAAAAAAAAAB8AAABUAAAAAAAABQAAAAEAAAAAAAAAAAAAAAAAAAAAAAAAAAAAAAAAAAAAAAAAAAAAAAJ/f38AWVlZA8zMzADAwP8Af39/AAAAAAAAAAAAAAAAAAAAAAAAAAAAIQAAABgAAAAUAAAAFAMAALMLAAB/NwAAuScAABAAAAAmAAAACAAAADwwAAAAAAAA"/>
+                <pr:smNativeData xmlns:pr="smNativeData" xmlns="smNativeData" val="SMDATA_15_FUV5ZhMAAAAlAAAAZAAAAA0AAAAAkAAAAJAAAACQAAAAkAAAAAAAAAAAAAAAAAAAAAEAAABQAAAAAAAAAAAA4D8AAAAAAADgPwAAAAAAAOA/AAAAAAAA4D8AAAAAAADgPwAAAAAAAOA/AAAAAAAA4D8AAAAAAADgPwAAAAAAAOA/AAAAAAAA4D8CAAAAjAAAAAAAAAAAAAAAQoX0DP///wgAAAAAAAAAAAAAAAAAAAAAAAAAAAAAAAAAAAAAZAAAAAEAAABAAAAAAAAAAAAAAAAAAAAAAAAAAAAAAAAAAAAAAAAAAAAAAAAAAAAAAAAAAAAAAAAAAAAAAAAAAAAAAAAAAAAAAAAAAAAAAAAAAAAAAAAAAAAAAAAAAAAAFAAAADwAAAAAAAAAAAAAAAAAAAkUAAAAAQAAABQAAAAUAAAAFAAAAAEAAAAAAAAAZAAAAGQAAAAAAAAAZAAAAGQAAAAVAAAAYAAAAAAAAAAAAAAADwAAACADAAAAAAAAAAAAAAEAAACgMgAAVgcAAKr4//8BAAAAf39/AAEAAABkAAAAAAAAABQAAABAHwAAAAAAACYAAAAAAAAAwOD//wAAAAAmAAAAZAAAABYAAABMAAAAAAAAAAAAAAAEAAAAAAAAAAEAAABZWVkKAAAAACgAAAAoAAAAZAAAAGQAAAAAAAAAzMzMAAAAAABQAAAAUAAAAGQAAABkAAAAAAAAABcAAAAUAAAAAAAAAAAAAAD/fwAA/38AAAAAAAAJAAAABAAAAF8AYAAeAAAAaAAAAAAAAAAAAAAAAAAAAAAAAAAAAAAAECcAABAnAAAAAAAAAAAAAAAAAAAAAAAAAAAAAAAAAAAAAAAAAAAAABQAAAAAAAAAwMD/AAAAAABkAAAAMgAAAAAAAABkAAAAAAAAAH9/fwAKAAAAIgAAABgAAAAAAAAAAAAAAAAAAAAAAAAAAAAAAAAAAAAkAAAAJAAAAAAAAAAHAAAAAAAAAAAAAAAAAAAAAAAAAAAAAAAAAAAAf39/ACUAAABYAAAAAAAAAAAAAAAAAAAAAAAAAAAAAAAAAAAAAAAAAAAAAAAAAAAAAAAAAAAAAAA/AAAAAAAAAKCGAQAAAAAAAAAAAAAAAAAMAAAAAQAAAAAAAAAAAAAAAAAAAB8AAABUAAAAAAAABQAAAAEAAAAAAAAAAAAAAAAAAAAAAAAAAAAAAAAAAAAAAAAAAAAAAAJ/f38AWVlZA8zMzADAwP8Af39/AAAAAAAAAAAAAAAAAAAAAAAAAAAAIQAAABgAAAAUAAAAFAMAALMLAAB/NwAAuScAABAAAAAmAAAACAAAADwwAAAAAAAA"/>
               </a:ext>
             </a:extLst>
           </p:cNvSpPr>
@@ -13861,7 +13861,7 @@
             <a:picLocks noChangeAspect="1"/>
             <a:extLst>
               <a:ext uri="smNativeData">
-                <pr:smNativeData xmlns:pr="smNativeData" xmlns="smNativeData" val="SMDATA_17_LkR5ZhMAAAAlAAAAEQAAAC8BAAAAkAAAAEgAAACQAAAASAAAAAAAAAAAAAAAAAAAAAEAAABQAAAAAAAAAAAA4D8AAAAAAADgPwAAAAAAAOA/AAAAAAAA4D8AAAAAAADgPwAAAAAAAOA/AAAAAAAA4D8AAAAAAADgPwAAAAAAAOA/AAAAAAAA4D8CAAAAjAAAAAAAAAAAAAAAQoX0DP///wgAAAAAAAAAAAAAAAAAAAAAAAAAAAAAAAAAAAAAZAAAAAEAAABAAAAAAAAAAAAAAAAAAAAAAAAAAAAAAAAAAAAAAAAAAAAAAAAAAAAAAAAAAAAAAAAAAAAAAAAAAAAAAAAAAAAAAAAAAAAAAAAAAAAAAAAAAAAAAAAAAAAAFAAAADwAAAAAAAAAAAAAAAAAAAkUAAAAAQAAABQAAAAUAAAAFAAAAAEAAAAAAAAAZAAAAGQAAAAAAAAAZAAAAGQAAAAVAAAAYAAAAAAAAAAAAAAADwAAACADAAAAAAAAAAAAAAEAAACgMgAAVgcAAKr4//8BAAAAf39/AAEAAABkAAAAAAAAABQAAABAHwAAAAAAACYAAAAAAAAAwOD//wAAAAAmAAAAZAAAABYAAABMAAAAAAAAAAAAAAAEAAAAAAAAAAEAAABZWVkKAAAAACgAAAAoAAAAZAAAAGQAAAAAAAAAzMzMAAAAAABQAAAAUAAAAGQAAABkAAAAAAAAAAcAAAA4AAAAAAAAAAAAAAAAAAAA////AAAAAAAAAAAAAAAAAAAAAAAAAAAAAAAAAAAAAABkAAAAZAAAAAAAAAAjAAAABAAAAGQAAAAXAAAAFAAAAAAAAAAAAAAA/38AAP9/AAAAAAAACQAAAAQAAAAOAAAAHgAAAGgAAAAAAAAAAAAAAAAAAAAAAAAAAAAAABAnAAAQJwAAAAAAAAAAAAAAAAAAAAAAAAAAAAAAAAAAAAAAAAAAAAAUAAAAAAAAAMDA/wAAAAAAZAAAADIAAAAAAAAAZAAAAAAAAAB/f38ACgAAACIAAAAYAAAAAAAAAAAAAAAAAAAAAAAAAAAAAAAAAAAAJAAAACQAAAAAAAAABwAAAAAAAAAAAAAAAAAAAAAAAAAAAAAAAAAAAH9/fwAlAAAAWAAAAAAAAAAAAAAAAAAAAAAAAAAAAAAAAAAAAAAAAAAAAAAAAAAAAAAAAAAAAAAAPwAAAAAAAACghgEAAAAAAAAAAAAAAAAADAAAAAEAAAAAAAAAAAAAAAAAAAAfAAAAVAAAAEKF9AX///8BAAAAAAAAAAAAAAAAAAAAAAAAAAAAAAAAAAAAAAAAAAAAAAACf39/AFlZWQPMzMwAwMD/AH9/fwAAAAAAAAAAAAAAAAD///8AAAAAACEAAAAYAAAAFAAAANwDAADmDgAAHSAAAMMlAAAQAAAAJgAAAAgAAAD//////////w=="/>
+                <pr:smNativeData xmlns:pr="smNativeData" xmlns="smNativeData" val="SMDATA_17_FUV5ZhMAAAAlAAAAEQAAAC8BAAAAkAAAAEgAAACQAAAASAAAAAAAAAAAAAAAAAAAAAEAAABQAAAAAAAAAAAA4D8AAAAAAADgPwAAAAAAAOA/AAAAAAAA4D8AAAAAAADgPwAAAAAAAOA/AAAAAAAA4D8AAAAAAADgPwAAAAAAAOA/AAAAAAAA4D8CAAAAjAAAAAAAAAAAAAAAQoX0DP///wgAAAAAAAAAAAAAAAAAAAAAAAAAAAAAAAAAAAAAZAAAAAEAAABAAAAAAAAAAAAAAAAAAAAAAAAAAAAAAAAAAAAAAAAAAAAAAAAAAAAAAAAAAAAAAAAAAAAAAAAAAAAAAAAAAAAAAAAAAAAAAAAAAAAAAAAAAAAAAAAAAAAAFAAAADwAAAAAAAAAAAAAAAAAAAkUAAAAAQAAABQAAAAUAAAAFAAAAAEAAAAAAAAAZAAAAGQAAAAAAAAAZAAAAGQAAAAVAAAAYAAAAAAAAAAAAAAADwAAACADAAAAAAAAAAAAAAEAAACgMgAAVgcAAKr4//8BAAAAf39/AAEAAABkAAAAAAAAABQAAABAHwAAAAAAACYAAAAAAAAAwOD//wAAAAAmAAAAZAAAABYAAABMAAAAAAAAAAAAAAAEAAAAAAAAAAEAAABZWVkKAAAAACgAAAAoAAAAZAAAAGQAAAAAAAAAzMzMAAAAAABQAAAAUAAAAGQAAABkAAAAAAAAAAcAAAA4AAAAAAAAAAAAAAAAAAAA////AAAAAAAAAAAAAAAAAAAAAAAAAAAAAAAAAAAAAABkAAAAZAAAAAAAAAAjAAAABAAAAGQAAAAXAAAAFAAAAAAAAAAAAAAA/38AAP9/AAAAAAAACQAAAAQAAAAOAAAAHgAAAGgAAAAAAAAAAAAAAAAAAAAAAAAAAAAAABAnAAAQJwAAAAAAAAAAAAAAAAAAAAAAAAAAAAAAAAAAAAAAAAAAAAAUAAAAAAAAAMDA/wAAAAAAZAAAADIAAAAAAAAAZAAAAAAAAAB/f38ACgAAACIAAAAYAAAAAAAAAAAAAAAAAAAAAAAAAAAAAAAAAAAAJAAAACQAAAAAAAAABwAAAAAAAAAAAAAAAAAAAAAAAAAAAAAAAAAAAH9/fwAlAAAAWAAAAAAAAAAAAAAAAAAAAAAAAAAAAAAAAAAAAAAAAAAAAAAAAAAAAAAAAAAAAAAAPwAAAAAAAACghgEAAAAAAAAAAAAAAAAADAAAAAEAAAAAAAAAAAAAAAAAAAAfAAAAVAAAAEKF9AX///8BAAAAAAAAAAAAAAAAAAAAAAAAAAAAAAAAAAAAAAAAAAAAAAACf39/AFlZWQPMzMwAwMD/AH9/fwAAAAAAAAAAAAAAAAD///8AAAAAACEAAAAYAAAAFAAAANwDAADmDgAAHSAAAMMlAAAQAAAAJgAAAAgAAAD//////////w=="/>
               </a:ext>
             </a:extLst>
           </p:cNvPicPr>
@@ -13927,7 +13927,7 @@
             <a:spLocks noGrp="1" noChangeArrowheads="1"/>
             <a:extLst>
               <a:ext uri="smNativeData">
-                <pr:smNativeData xmlns:pr="smNativeData" xmlns="smNativeData" val="SMDATA_15_LkR5ZhMAAAAlAAAAZAAAAA0AAAAAkAAAAJAAAACQAAAAkAAAAAAAAAAAAAAAAAAAAAEAAABQAAAAAAAAAAAA4D8AAAAAAADgPwAAAAAAAOA/AAAAAAAA4D8AAAAAAADgPwAAAAAAAOA/AAAAAAAA4D8AAAAAAADgPwAAAAAAAOA/AAAAAAAA4D8CAAAAjAAAAAAAAAAAAAAAQoX0DP///wgAAAAAAAAAAAAAAAAAAAAAAAAAAAAAAAAAAAAAZAAAAAEAAABAAAAAAAAAAAAAAAAAAAAAAAAAAAAAAAAAAAAAAAAAAAAAAAAAAAAAAAAAAAAAAAAAAAAAAAAAAAAAAAAAAAAAAAAAAAAAAAAAAAAAAAAAAAAAAAAAAAAAFAAAADwAAAAAAAAAAAAAAAAAAAkUAAAAAQAAABQAAAAUAAAAFAAAAAEAAAAAAAAAZAAAAGQAAAAAAAAAZAAAAGQAAAAVAAAAYAAAAAAAAAAAAAAADwAAACADAAAAAAAAAAAAAAEAAACgMgAAVgcAAKr4//8BAAAAf39/AAEAAABkAAAAAAAAABQAAABAHwAAAAAAACYAAAAAAAAAwOD//wAAAAAmAAAAZAAAABYAAABMAAAAAAAAAAAAAAAEAAAAAAAAAAEAAABZWVkKAAAAACgAAAAoAAAAZAAAAGQAAAAAAAAAzMzMAAAAAABQAAAAUAAAAGQAAABkAAAAAAAAABcAAAAUAAAAAAAAAAAAAAD/fwAA/38AAAAAAAAJAAAABAAAAAAAAAAeAAAAaAAAAAAAAAAAAAAAAAAAAAAAAAAAAAAAECcAABAnAAAAAAAAAAAAAAAAAAAAAAAAAAAAAAAAAAAAAAAAAAAAABQAAAAAAAAAwMD/AAAAAABkAAAAMgAAAAAAAABkAAAAAAAAAH9/fwAKAAAAIgAAABgAAAAAAAAAAAAAAAAAAAAAAAAAAAAAAAAAAAAkAAAAJAAAAAAAAAAHAAAAAAAAAAAAAAAAAAAAAAAAAAAAAAAAAAAAf39/ACUAAABYAAAAAAAAAAAAAAAAAAAAAAAAAAAAAAAAAAAAAAAAAAAAAAAAAAAAAAAAAAAAAAA/AAAAAAAAAKCGAQAAAAAAAAAAAAAAAAAMAAAAAQAAAAAAAAAAAAAAAAAAAB8AAABUAAAAAAAABQAAAAEAAAAAAAAAAAAAAAAAAAAAAAAAAAAAAAAAAAAAAAAAAAAAAAJ/f38AWVlZA8zMzADAwP8Af39/AAAAAAAAAAAAAAAAAAAAAAAAAAAAIQAAABgAAAAUAAAAFAMAALYCAAB/NwAAvwoAABAAAAAmAAAACAAAAAAAAAAAAAAA"/>
+                <pr:smNativeData xmlns:pr="smNativeData" xmlns="smNativeData" val="SMDATA_15_FUV5ZhMAAAAlAAAAZAAAAA0AAAAAkAAAAJAAAACQAAAAkAAAAAAAAAAAAAAAAAAAAAEAAABQAAAAAAAAAAAA4D8AAAAAAADgPwAAAAAAAOA/AAAAAAAA4D8AAAAAAADgPwAAAAAAAOA/AAAAAAAA4D8AAAAAAADgPwAAAAAAAOA/AAAAAAAA4D8CAAAAjAAAAAAAAAAAAAAAQoX0DP///wgAAAAAAAAAAAAAAAAAAAAAAAAAAAAAAAAAAAAAZAAAAAEAAABAAAAAAAAAAAAAAAAAAAAAAAAAAAAAAAAAAAAAAAAAAAAAAAAAAAAAAAAAAAAAAAAAAAAAAAAAAAAAAAAAAAAAAAAAAAAAAAAAAAAAAAAAAAAAAAAAAAAAFAAAADwAAAAAAAAAAAAAAAAAAAkUAAAAAQAAABQAAAAUAAAAFAAAAAEAAAAAAAAAZAAAAGQAAAAAAAAAZAAAAGQAAAAVAAAAYAAAAAAAAAAAAAAADwAAACADAAAAAAAAAAAAAAEAAACgMgAAVgcAAKr4//8BAAAAf39/AAEAAABkAAAAAAAAABQAAABAHwAAAAAAACYAAAAAAAAAwOD//wAAAAAmAAAAZAAAABYAAABMAAAAAAAAAAAAAAAEAAAAAAAAAAEAAABZWVkKAAAAACgAAAAoAAAAZAAAAGQAAAAAAAAAzMzMAAAAAABQAAAAUAAAAGQAAABkAAAAAAAAABcAAAAUAAAAAAAAAAAAAAD/fwAA/38AAAAAAAAJAAAABAAAAAAAAAAeAAAAaAAAAAAAAAAAAAAAAAAAAAAAAAAAAAAAECcAABAnAAAAAAAAAAAAAAAAAAAAAAAAAAAAAAAAAAAAAAAAAAAAABQAAAAAAAAAwMD/AAAAAABkAAAAMgAAAAAAAABkAAAAAAAAAH9/fwAKAAAAIgAAABgAAAAAAAAAAAAAAAAAAAAAAAAAAAAAAAAAAAAkAAAAJAAAAAAAAAAHAAAAAAAAAAAAAAAAAAAAAAAAAAAAAAAAAAAAf39/ACUAAABYAAAAAAAAAAAAAAAAAAAAAAAAAAAAAAAAAAAAAAAAAAAAAAAAAAAAAAAAAAAAAAA/AAAAAAAAAKCGAQAAAAAAAAAAAAAAAAAMAAAAAQAAAAAAAAAAAAAAAAAAAB8AAABUAAAAAAAABQAAAAEAAAAAAAAAAAAAAAAAAAAAAAAAAAAAAAAAAAAAAAAAAAAAAAJ/f38AWVlZA8zMzADAwP8Af39/AAAAAAAAAAAAAAAAAAAAAAAAAAAAIQAAABgAAAAUAAAAFAMAALYCAAB/NwAAvwoAABAAAAAmAAAACAAAAAAAAAAAAAAA"/>
               </a:ext>
             </a:extLst>
           </p:cNvSpPr>
@@ -13954,7 +13954,7 @@
             <a:spLocks noGrp="1" noChangeArrowheads="1"/>
             <a:extLst>
               <a:ext uri="smNativeData">
-                <pr:smNativeData xmlns:pr="smNativeData" xmlns="smNativeData" val="SMDATA_15_LkR5ZhMAAAAlAAAAZAAAAA0AAAAAkAAAAJAAAACQAAAAkAAAAAAAAAAAAAAAAAAAAAEAAABQAAAAAAAAAAAA4D8AAAAAAADgPwAAAAAAAOA/AAAAAAAA4D8AAAAAAADgPwAAAAAAAOA/AAAAAAAA4D8AAAAAAADgPwAAAAAAAOA/AAAAAAAA4D8CAAAAjAAAAAAAAAAAAAAAQoX0DP///wgAAAAAAAAAAAAAAAAAAAAAAAAAAAAAAAAAAAAAZAAAAAEAAABAAAAAAAAAAAAAAAAAAAAAAAAAAAAAAAAAAAAAAAAAAAAAAAAAAAAAAAAAAAAAAAAAAAAAAAAAAAAAAAAAAAAAAAAAAAAAAAAAAAAAAAAAAAAAAAAAAAAAFAAAADwAAAAAAAAAAAAAAAAAAAkUAAAAAQAAABQAAAAUAAAAFAAAAAEAAAAAAAAAZAAAAGQAAAAAAAAAZAAAAGQAAAAVAAAAYAAAAAAAAAAAAAAADwAAACADAAAAAAAAAAAAAAEAAACgMgAAVgcAAKr4//8BAAAAf39/AAEAAABkAAAAAAAAABQAAABAHwAAAAAAACYAAAAAAAAAwOD//wAAAAAmAAAAZAAAABYAAABMAAAAAAAAAAAAAAAEAAAAAAAAAAEAAABZWVkKAAAAACgAAAAoAAAAZAAAAGQAAAAAAAAAzMzMAAAAAABQAAAAUAAAAGQAAABkAAAAAAAAABcAAAAUAAAAAAAAAAAAAAD/fwAA/38AAAAAAAAJAAAABAAAAAAAAAAeAAAAaAAAAAAAAAAAAAAAAAAAAAAAAAAAAAAAECcAABAnAAAAAAAAAAAAAAAAAAAAAAAAAAAAAAAAAAAAAAAAAAAAABQAAAAAAAAAwMD/AAAAAABkAAAAMgAAAAAAAABkAAAAAAAAAH9/fwAKAAAAIgAAABgAAAAAAAAAAAAAAAAAAAAAAAAAAAAAAAAAAAAkAAAAJAAAAAAAAAAHAAAAAAAAAAAAAAAAAAAAAAAAAAAAAAAAAAAAf39/ACUAAABYAAAAAAAAAAAAAAAAAAAAAAAAAAAAAAAAAAAAAAAAAAAAAAAAAAAAAAAAAAAAAAA/AAAAAAAAAKCGAQAAAAAAAAAAAAAAAAAMAAAAAQAAAAAAAAAAAAAAAAAAAB8AAABUAAAAAAAABQAAAAEAAAAAAAAAAAAAAAAAAAAAAAAAAAAAAAAAAAAAAAAAAAAAAAJ/f38AWVlZA8zMzADAwP8Af39/AAAAAAAAAAAAAAAAAAAAAAAAAAAAIQAAABgAAAAUAAAAFAMAALMLAAB/NwAAuScAABAAAAAmAAAACAAAAAAAAAAAAAAA"/>
+                <pr:smNativeData xmlns:pr="smNativeData" xmlns="smNativeData" val="SMDATA_15_FUV5ZhMAAAAlAAAAZAAAAA0AAAAAkAAAAJAAAACQAAAAkAAAAAAAAAAAAAAAAAAAAAEAAABQAAAAAAAAAAAA4D8AAAAAAADgPwAAAAAAAOA/AAAAAAAA4D8AAAAAAADgPwAAAAAAAOA/AAAAAAAA4D8AAAAAAADgPwAAAAAAAOA/AAAAAAAA4D8CAAAAjAAAAAAAAAAAAAAAQoX0DP///wgAAAAAAAAAAAAAAAAAAAAAAAAAAAAAAAAAAAAAZAAAAAEAAABAAAAAAAAAAAAAAAAAAAAAAAAAAAAAAAAAAAAAAAAAAAAAAAAAAAAAAAAAAAAAAAAAAAAAAAAAAAAAAAAAAAAAAAAAAAAAAAAAAAAAAAAAAAAAAAAAAAAAFAAAADwAAAAAAAAAAAAAAAAAAAkUAAAAAQAAABQAAAAUAAAAFAAAAAEAAAAAAAAAZAAAAGQAAAAAAAAAZAAAAGQAAAAVAAAAYAAAAAAAAAAAAAAADwAAACADAAAAAAAAAAAAAAEAAACgMgAAVgcAAKr4//8BAAAAf39/AAEAAABkAAAAAAAAABQAAABAHwAAAAAAACYAAAAAAAAAwOD//wAAAAAmAAAAZAAAABYAAABMAAAAAAAAAAAAAAAEAAAAAAAAAAEAAABZWVkKAAAAACgAAAAoAAAAZAAAAGQAAAAAAAAAzMzMAAAAAABQAAAAUAAAAGQAAABkAAAAAAAAABcAAAAUAAAAAAAAAAAAAAD/fwAA/38AAAAAAAAJAAAABAAAAAAAAAAeAAAAaAAAAAAAAAAAAAAAAAAAAAAAAAAAAAAAECcAABAnAAAAAAAAAAAAAAAAAAAAAAAAAAAAAAAAAAAAAAAAAAAAABQAAAAAAAAAwMD/AAAAAABkAAAAMgAAAAAAAABkAAAAAAAAAH9/fwAKAAAAIgAAABgAAAAAAAAAAAAAAAAAAAAAAAAAAAAAAAAAAAAkAAAAJAAAAAAAAAAHAAAAAAAAAAAAAAAAAAAAAAAAAAAAAAAAAAAAf39/ACUAAABYAAAAAAAAAAAAAAAAAAAAAAAAAAAAAAAAAAAAAAAAAAAAAAAAAAAAAAAAAAAAAAA/AAAAAAAAAKCGAQAAAAAAAAAAAAAAAAAMAAAAAQAAAAAAAAAAAAAAAAAAAB8AAABUAAAAAAAABQAAAAEAAAAAAAAAAAAAAAAAAAAAAAAAAAAAAAAAAAAAAAAAAAAAAAJ/f38AWVlZA8zMzADAwP8Af39/AAAAAAAAAAAAAAAAAAAAAAAAAAAAIQAAABgAAAAUAAAAFAMAALMLAAB/NwAAuScAABAAAAAmAAAACAAAAAAAAAAAAAAA"/>
               </a:ext>
             </a:extLst>
           </p:cNvSpPr>
@@ -13987,7 +13987,7 @@
             <a:picLocks noChangeAspect="1"/>
             <a:extLst>
               <a:ext uri="smNativeData">
-                <pr:smNativeData xmlns:pr="smNativeData" xmlns="smNativeData" val="SMDATA_17_LkR5ZhMAAAAlAAAAEQAAAC8BAAAAkAAAAEgAAACQAAAASAAAAAAAAAAAAAAAAAAAAAEAAABQAAAAAAAAAAAA4D8AAAAAAADgPwAAAAAAAOA/AAAAAAAA4D8AAAAAAADgPwAAAAAAAOA/AAAAAAAA4D8AAAAAAADgPwAAAAAAAOA/AAAAAAAA4D8CAAAAjAAAAAAAAAAAAAAAQoX0DP///wgAAAAAAAAAAAAAAAAAAAAAAAAAAAAAAAAAAAAAZAAAAAEAAABAAAAAAAAAAAAAAAAAAAAAAAAAAAAAAAAAAAAAAAAAAAAAAAAAAAAAAAAAAAAAAAAAAAAAAAAAAAAAAAAAAAAAAAAAAAAAAAAAAAAAAAAAAAAAAAAAAAAAFAAAADwAAAAAAAAAAAAAAAAAAAkUAAAAAQAAABQAAAAUAAAAFAAAAAEAAAAAAAAAZAAAAGQAAAAAAAAAZAAAAGQAAAAVAAAAYAAAAAAAAAAAAAAADwAAACADAAAAAAAAAAAAAAEAAACgMgAAVgcAAKr4//8BAAAAf39/AAEAAABkAAAAAAAAABQAAABAHwAAAAAAACYAAAAAAAAAwOD//wAAAAAmAAAAZAAAABYAAABMAAAAAAAAAAAAAAAEAAAAAAAAAAEAAABZWVkKAAAAACgAAAAoAAAAZAAAAGQAAAAAAAAAzMzMAAAAAABQAAAAUAAAAGQAAABkAAAAAAAAAAcAAAA4AAAAAAAAAAAAAAAAAAAA////AAAAAAAAAAAAAAAAAAAAAAAAAAAAAAAAAAAAAABkAAAAZAAAAAAAAAAjAAAABAAAAGQAAAAXAAAAFAAAAAAAAAAAAAAA/38AAP9/AAAAAAAACQAAAAQAAADFAAAAHgAAAGgAAAAAAAAAAAAAAAAAAAAAAAAAAAAAABAnAAAQJwAAAAAAAAAAAAAAAAAAAAAAAAAAAAAAAAAAAAAAAAAAAAAUAAAAAAAAAMDA/wAAAAAAZAAAADIAAAAAAAAAZAAAAAAAAAB/f38ACgAAACIAAAAYAAAAAAAAAAAAAAAAAAAAAAAAAAAAAAAAAAAAJAAAACQAAAAAAAAABwAAAAAAAAAAAAAAAAAAAAAAAAAAAAAAAAAAAH9/fwAlAAAAWAAAAAAAAAAAAAAAAAAAAAAAAAAAAAAAAAAAAAAAAAAAAAAAAAAAAAAAAAAAAAAAPwAAAAAAAACghgEAAAAAAAAAAAAAAAAADAAAAAEAAAAAAAAAAAAAAAAAAAAfAAAAVAAAAEKF9AX///8BAAAAAAAAAAAAAAAAAAAAAAAAAAAAAAAAAAAAAAAAAAAAAAACf39/AFlZWQPMzMwAwMD/AH9/fwAAAAAAAAAAAAAAAAD///8AAAAAACEAAAAYAAAAFAAAAO8DAACGDgAAOyMAAKQlAAAQAAAAJgAAAAgAAAD//////////w=="/>
+                <pr:smNativeData xmlns:pr="smNativeData" xmlns="smNativeData" val="SMDATA_17_FUV5ZhMAAAAlAAAAEQAAAC8BAAAAkAAAAEgAAACQAAAASAAAAAAAAAAAAAAAAAAAAAEAAABQAAAAAAAAAAAA4D8AAAAAAADgPwAAAAAAAOA/AAAAAAAA4D8AAAAAAADgPwAAAAAAAOA/AAAAAAAA4D8AAAAAAADgPwAAAAAAAOA/AAAAAAAA4D8CAAAAjAAAAAAAAAAAAAAAQoX0DP///wgAAAAAAAAAAAAAAAAAAAAAAAAAAAAAAAAAAAAAZAAAAAEAAABAAAAAAAAAAAAAAAAAAAAAAAAAAAAAAAAAAAAAAAAAAAAAAAAAAAAAAAAAAAAAAAAAAAAAAAAAAAAAAAAAAAAAAAAAAAAAAAAAAAAAAAAAAAAAAAAAAAAAFAAAADwAAAAAAAAAAAAAAAAAAAkUAAAAAQAAABQAAAAUAAAAFAAAAAEAAAAAAAAAZAAAAGQAAAAAAAAAZAAAAGQAAAAVAAAAYAAAAAAAAAAAAAAADwAAACADAAAAAAAAAAAAAAEAAACgMgAAVgcAAKr4//8BAAAAf39/AAEAAABkAAAAAAAAABQAAABAHwAAAAAAACYAAAAAAAAAwOD//wAAAAAmAAAAZAAAABYAAABMAAAAAAAAAAAAAAAEAAAAAAAAAAEAAABZWVkKAAAAACgAAAAoAAAAZAAAAGQAAAAAAAAAzMzMAAAAAABQAAAAUAAAAGQAAABkAAAAAAAAAAcAAAA4AAAAAAAAAAAAAAAAAAAA////AAAAAAAAAAAAAAAAAAAAAAAAAAAAAAAAAAAAAABkAAAAZAAAAAAAAAAjAAAABAAAAGQAAAAXAAAAFAAAAAAAAAAAAAAA/38AAP9/AAAAAAAACQAAAAQAAADFAAAAHgAAAGgAAAAAAAAAAAAAAAAAAAAAAAAAAAAAABAnAAAQJwAAAAAAAAAAAAAAAAAAAAAAAAAAAAAAAAAAAAAAAAAAAAAUAAAAAAAAAMDA/wAAAAAAZAAAADIAAAAAAAAAZAAAAAAAAAB/f38ACgAAACIAAAAYAAAAAAAAAAAAAAAAAAAAAAAAAAAAAAAAAAAAJAAAACQAAAAAAAAABwAAAAAAAAAAAAAAAAAAAAAAAAAAAAAAAAAAAH9/fwAlAAAAWAAAAAAAAAAAAAAAAAAAAAAAAAAAAAAAAAAAAAAAAAAAAAAAAAAAAAAAAAAAAAAAPwAAAAAAAACghgEAAAAAAAAAAAAAAAAADAAAAAEAAAAAAAAAAAAAAAAAAAAfAAAAVAAAAEKF9AX///8BAAAAAAAAAAAAAAAAAAAAAAAAAAAAAAAAAAAAAAAAAAAAAAACf39/AFlZWQPMzMwAwMD/AH9/fwAAAAAAAAAAAAAAAAD///8AAAAAACEAAAAYAAAAFAAAAO8DAACGDgAAOyMAAKQlAAAQAAAAJgAAAAgAAAD//////////w=="/>
               </a:ext>
             </a:extLst>
           </p:cNvPicPr>
@@ -14362,6 +14362,47 @@
       </a:clrScheme>
       <a:clrMap bg1="lt1" tx1="dk1" bg2="lt2" tx2="dk2" accent1="accent1" accent2="accent2" accent3="accent3" accent4="accent4" accent5="accent5" accent6="accent6" hlink="hlink" folHlink="folHlink"/>
     </a:extraClrScheme>
+    <a:extraClrScheme>
+      <a:clrScheme name="Presentation 3">
+        <a:dk1>
+          <a:srgbClr val="000000"/>
+        </a:dk1>
+        <a:lt1>
+          <a:srgbClr val="FFFFFF"/>
+        </a:lt1>
+        <a:dk2>
+          <a:srgbClr val="EEEEEE"/>
+        </a:dk2>
+        <a:lt2>
+          <a:srgbClr val="595959"/>
+        </a:lt2>
+        <a:accent1>
+          <a:srgbClr val="4285F4"/>
+        </a:accent1>
+        <a:accent2>
+          <a:srgbClr val="212121"/>
+        </a:accent2>
+        <a:accent3>
+          <a:srgbClr val="78909C"/>
+        </a:accent3>
+        <a:accent4>
+          <a:srgbClr val="FFAB40"/>
+        </a:accent4>
+        <a:accent5>
+          <a:srgbClr val="0097A7"/>
+        </a:accent5>
+        <a:accent6>
+          <a:srgbClr val="EEFF41"/>
+        </a:accent6>
+        <a:hlink>
+          <a:srgbClr val="0097A7"/>
+        </a:hlink>
+        <a:folHlink>
+          <a:srgbClr val="0097A7"/>
+        </a:folHlink>
+      </a:clrScheme>
+      <a:clrMap bg1="lt1" tx1="dk1" bg2="lt2" tx2="dk2" accent1="accent1" accent2="accent2" accent3="accent3" accent4="accent4" accent5="accent5" accent6="accent6" hlink="hlink" folHlink="folHlink"/>
+    </a:extraClrScheme>
   </a:extraClrSchemeLst>
 </a:theme>
 </file>
@@ -14660,6 +14701,47 @@
     </a:extraClrScheme>
     <a:extraClrScheme>
       <a:clrScheme name="Presentation 2">
+        <a:dk1>
+          <a:srgbClr val="000000"/>
+        </a:dk1>
+        <a:lt1>
+          <a:srgbClr val="FFFFFF"/>
+        </a:lt1>
+        <a:dk2>
+          <a:srgbClr val="F3F3F3"/>
+        </a:dk2>
+        <a:lt2>
+          <a:srgbClr val="158158"/>
+        </a:lt2>
+        <a:accent1>
+          <a:srgbClr val="058DC7"/>
+        </a:accent1>
+        <a:accent2>
+          <a:srgbClr val="50B432"/>
+        </a:accent2>
+        <a:accent3>
+          <a:srgbClr val="ED561B"/>
+        </a:accent3>
+        <a:accent4>
+          <a:srgbClr val="EDEF00"/>
+        </a:accent4>
+        <a:accent5>
+          <a:srgbClr val="24CBE5"/>
+        </a:accent5>
+        <a:accent6>
+          <a:srgbClr val="64E572"/>
+        </a:accent6>
+        <a:hlink>
+          <a:srgbClr val="2200CC"/>
+        </a:hlink>
+        <a:folHlink>
+          <a:srgbClr val="551A8B"/>
+        </a:folHlink>
+      </a:clrScheme>
+      <a:clrMap bg1="lt1" tx1="dk1" bg2="lt2" tx2="dk2" accent1="accent1" accent2="accent2" accent3="accent3" accent4="accent4" accent5="accent5" accent6="accent6" hlink="hlink" folHlink="folHlink"/>
+    </a:extraClrScheme>
+    <a:extraClrScheme>
+      <a:clrScheme name="Presentation 3">
         <a:dk1>
           <a:srgbClr val="000000"/>
         </a:dk1>

--- a/project/Защита_проекта_Микросервис_на_основе_Apache_Kafka.pptx
+++ b/project/Защита_проекта_Микросервис_на_основе_Apache_Kafka.pptx
@@ -270,7 +270,7 @@
             <a:spLocks noGrp="1" noChangeArrowheads="1"/>
             <a:extLst>
               <a:ext uri="smNativeData">
-                <pr:smNativeData xmlns:pr="smNativeData" xmlns="smNativeData" val="SMDATA_15_FUV5ZhMAAAAlAAAACwAAAA0AAAAACAcAADgEAAAoIwAAUBkAAAAAAAAAAAAAAAAAAAEAAABQAAAAAAAAAAAA4D8AAAAAAADgPwAAAAAAAOA/AAAAAAAA4D8AAAAAAADgPwAAAAAAAOA/AAAAAAAA4D8AAAAAAADgPwAAAAAAAOA/AAAAAAAA4D8CAAAAjAAAAAAAAAAAAAAABY3HDP///wgAAAAAAAAAAAAAAAAAAAAAAAAAAAAAAAAAAAAAZAAAAAEAAABAAAAAAAAAAAAAAAAAAAAAAAAAAAAAAAAAAAAAAAAAAAAAAAAAAAAAAAAAAAAAAAAAAAAAAAAAAAAAAAAAAAAAAAAAAAAAAAAAAAAAAAAAAAAAAAAAAAAAFAAAADwAAAABAAAAAAAAAAAAAAAPAAAAAQAAACMAAAAjAAAAIwAAAB4AAAAAAAAASwAAAEsAAAAAAAAASwAAAEsAAAAVAAAAYAAAAAAAAAAAAAAADwAAACADAAAAAAAAAAAAAAEAAACgMgAAVgcAAKr4//8BAAAAf39/AAEAAABkAAAAAAAAABQAAABAHwAAAAAAACYAAAAAAAAAwOD//wAAAAAmAAAAZAAAABYAAABMAAAAAAAAAAAAAAAEAAAAAAAAAAEAAAAVgVgKAAAAACgAAAAoAAAAZAAAAGQAAAAAAAAAzMzMAAAAAABQAAAAUAAAAGQAAABkAAAAAAAAABcAAAAUAAAAAAAAAAAAAAD/fwAA/38AAAAAAAAJAAAABAAAACwAAAAeAAAAaAAAAAAAAAAAAAAAAAAAAAAAAAAAAAAAECcAABAnAAAAAAAAAAAAAAAAAAAAAAAAAAAAAAAAAAAAAAAAAAAAABQAAAAAAAAAwMD/AAAAAABkAAAAMgAAAAAAAABkAAAAAAAAAH9/fwAKAAAAIgAAABgAAAAAAAAAAAAAAAAAAAAAAAAAAAAAAAAAAAAkAAAAJAAAAAAAAAAHAAAAAAAAAAAAAAAAAAAAAAAAAAAAAAAAAAAAf39/ACUAAABYAAAAAAAAAAAAAAAAAAAAAAAAAAAAAAAAAAAAAAAAAAAAAAAAAAAAAAAAAAAAAAA/AAAAAAAAAKCGAQAAAAAAAAAAAAAAAAAMAAAAAQAAAAAAAAAAAAAAAAAAAB8AAABUAAAAAAAABQAAAAEAAAAAAAAAAAAAAAAAAAAAAAAAAAAAAAAAAAAAAAAAAAAAAAB/f38AAAAAA8zMzADAwP8Af39/AAAAAAAAAAAAAAAAAAAAAAAAAAAAIQAAABgAAAAUAAAACAcAADgEAAAoIwAAUBkAABAAAAAmAAAACAAAAAEPAAD/HwAA"/>
+                <pr:smNativeData xmlns:pr="smNativeData" xmlns="smNativeData" val="SMDATA_15_9kV5ZhMAAAAlAAAACwAAAA0AAAAACAcAADgEAAAoIwAAUBkAAAAAAAAAAAAAAAAAAAEAAABQAAAAAAAAAAAA4D8AAAAAAADgPwAAAAAAAOA/AAAAAAAA4D8AAAAAAADgPwAAAAAAAOA/AAAAAAAA4D8AAAAAAADgPwAAAAAAAOA/AAAAAAAA4D8CAAAAjAAAAAAAAAAAAAAABY3HDP///wgAAAAAAAAAAAAAAAAAAAAAAAAAAAAAAAAAAAAAZAAAAAEAAABAAAAAAAAAAAAAAAAAAAAAAAAAAAAAAAAAAAAAAAAAAAAAAAAAAAAAAAAAAAAAAAAAAAAAAAAAAAAAAAAAAAAAAAAAAAAAAAAAAAAAAAAAAAAAAAAAAAAAFAAAADwAAAABAAAAAAAAAAAAAAAPAAAAAQAAACMAAAAjAAAAIwAAAB4AAAAAAAAASwAAAEsAAAAAAAAASwAAAEsAAAAVAAAAYAAAAAAAAAAAAAAADwAAACADAAAAAAAAAAAAAAEAAACgMgAAVgcAAKr4//8BAAAAf39/AAEAAABkAAAAAAAAABQAAABAHwAAAAAAACYAAAAAAAAAwOD//wAAAAAmAAAAZAAAABYAAABMAAAAAAAAAAAAAAAEAAAAAAAAAAEAAAAVgVgKAAAAACgAAAAoAAAAZAAAAGQAAAAAAAAAzMzMAAAAAABQAAAAUAAAAGQAAABkAAAAAAAAABcAAAAUAAAAAAAAAAAAAAD/fwAA/38AAAAAAAAJAAAABAAAACwAAAAeAAAAaAAAAAAAAAAAAAAAAAAAAAAAAAAAAAAAECcAABAnAAAAAAAAAAAAAAAAAAAAAAAAAAAAAAAAAAAAAAAAAAAAABQAAAAAAAAAwMD/AAAAAABkAAAAMgAAAAAAAABkAAAAAAAAAH9/fwAKAAAAIgAAABgAAAAAAAAAAAAAAAAAAAAAAAAAAAAAAAAAAAAkAAAAJAAAAAAAAAAHAAAAAAAAAAAAAAAAAAAAAAAAAAAAAAAAAAAAf39/ACUAAABYAAAAAAAAAAAAAAAAAAAAAAAAAAAAAAAAAAAAAAAAAAAAAAAAAAAAAAAAAAAAAAA/AAAAAAAAAKCGAQAAAAAAAAAAAAAAAAAMAAAAAQAAAAAAAAAAAAAAAAAAAB8AAABUAAAAAAAABQAAAAEAAAAAAAAAAAAAAAAAAAAAAAAAAAAAAAAAAAAAAAAAAAAAAAB/f38AAAAAA8zMzADAwP8Af39/AAAAAAAAAAAAAAAAAAAAAAAAAAAAIQAAABgAAAAUAAAACAcAADgEAAAoIwAAUBkAABAAAAAmAAAACAAAAAEPAAD/HwAA"/>
               </a:ext>
             </a:extLst>
           </p:cNvSpPr>
@@ -325,7 +325,7 @@
             <a:spLocks noGrp="1" noChangeArrowheads="1"/>
             <a:extLst>
               <a:ext uri="smNativeData">
-                <pr:smNativeData xmlns:pr="smNativeData" xmlns="smNativeData" val="SMDATA_15_FUV5ZhMAAAAlAAAAZAAAAA0AAAAAkAAAAJAAAACQAAAAkAAAAAAAAAAAAAAAAAAAAAEAAABQAAAAAAAAAAAA4D8AAAAAAADgPwAAAAAAAOA/AAAAAAAA4D8AAAAAAADgPwAAAAAAAOA/AAAAAAAA4D8AAAAAAADgPwAAAAAAAOA/AAAAAAAA4D8CAAAAjAAAAAAAAAAAAAAABY3HDP///wgAAAAAAAAAAAAAAAAAAAAAAAAAAAAAAAAAAAAAZAAAAAEAAABAAAAAAAAAAAAAAAAAAAAAAAAAAAAAAAAAAAAAAAAAAAAAAAAAAAAAAAAAAAAAAAAAAAAAAAAAAAAAAAAAAAAAAAAAAAAAAAAAAAAAAAAAAAAAAAAAAAAAFAAAADwAAAAAAAAAAAAAAAAAAAkUAAAAAQAAABQAAAAUAAAAFAAAAAEAAAAAAAAAZAAAAGQAAAAAAAAAZAAAAGQAAAAVAAAAYAAAAAAAAAAAAAAADwAAACADAAAAAAAAAAAAAAEAAACgMgAAVgcAAKr4//8BAAAAf39/AAEAAABkAAAAAAAAABQAAABAHwAAAAAAACYAAAAAAAAAwOD//wAAAAAmAAAAZAAAABYAAABMAAAAAAAAAAAAAAAEAAAAAAAAAAEAAAAVgVgKAAAAACgAAAAoAAAAZAAAAGQAAAAAAAAAzMzMAAAAAABQAAAAUAAAAGQAAABkAAAAAAAAABcAAAAUAAAAAAAAAAAAAAD/fwAA/38AAAAAAAAJAAAABAAAAHsAfAAeAAAAaAAAAAAAAAAAAAAAAAAAAAAAAAAAAAAAECcAABAnAAAAAAAAAAAAAAAAAAAAAAAAAAAAAAAAAAAAAAAAAAAAABQAAAAAAAAAwMD/AAAAAABkAAAAMgAAAAAAAABkAAAAAAAAAH9/fwAKAAAAIgAAABgAAAAAAAAAAAAAAAAAAAAAAAAAAAAAAAAAAAAkAAAAJAAAAAAAAAAHAAAAAAAAAAAAAAAAAAAAAAAAAAAAAAAAAAAAf39/ACUAAABYAAAAAAAAAAAAAAAAAAAAAAAAAAAAAAAAAAAAAAAAAAAAAAAAAAAAAAAAAAAAAAA/AAAAAAAAAKCGAQAAAAAAAAAAAAAAAAAMAAAAAQAAAAAAAAAAAAAAAAAAAB8AAABUAAAAAAAABQAAAAEAAAAAAAAAAAAAAAAAAAAAAAAAAAAAAAAAAAAAAAAAAAAAAAJ/f38AAAAAA8zMzADAwP8Af39/AAAAAAAAAAAAAAAAAAAAAAAAAAAAIQAAABgAAAAUAAAAOAQAALgaAAD4JQAACDQAABAAAAAmAAAACAAAAL2/AAD/HwAA"/>
+                <pr:smNativeData xmlns:pr="smNativeData" xmlns="smNativeData" val="SMDATA_15_9kV5ZhMAAAAlAAAAZAAAAA0AAAAAkAAAAJAAAACQAAAAkAAAAAAAAAAAAAAAAAAAAAEAAABQAAAAAAAAAAAA4D8AAAAAAADgPwAAAAAAAOA/AAAAAAAA4D8AAAAAAADgPwAAAAAAAOA/AAAAAAAA4D8AAAAAAADgPwAAAAAAAOA/AAAAAAAA4D8CAAAAjAAAAAAAAAAAAAAABY3HDP///wgAAAAAAAAAAAAAAAAAAAAAAAAAAAAAAAAAAAAAZAAAAAEAAABAAAAAAAAAAAAAAAAAAAAAAAAAAAAAAAAAAAAAAAAAAAAAAAAAAAAAAAAAAAAAAAAAAAAAAAAAAAAAAAAAAAAAAAAAAAAAAAAAAAAAAAAAAAAAAAAAAAAAFAAAADwAAAAAAAAAAAAAAAAAAAkUAAAAAQAAABQAAAAUAAAAFAAAAAEAAAAAAAAAZAAAAGQAAAAAAAAAZAAAAGQAAAAVAAAAYAAAAAAAAAAAAAAADwAAACADAAAAAAAAAAAAAAEAAACgMgAAVgcAAKr4//8BAAAAf39/AAEAAABkAAAAAAAAABQAAABAHwAAAAAAACYAAAAAAAAAwOD//wAAAAAmAAAAZAAAABYAAABMAAAAAAAAAAAAAAAEAAAAAAAAAAEAAAAVgVgKAAAAACgAAAAoAAAAZAAAAGQAAAAAAAAAzMzMAAAAAABQAAAAUAAAAGQAAABkAAAAAAAAABcAAAAUAAAAAAAAAAAAAAD/fwAA/38AAAAAAAAJAAAABAAAAHsAfAAeAAAAaAAAAAAAAAAAAAAAAAAAAAAAAAAAAAAAECcAABAnAAAAAAAAAAAAAAAAAAAAAAAAAAAAAAAAAAAAAAAAAAAAABQAAAAAAAAAwMD/AAAAAABkAAAAMgAAAAAAAABkAAAAAAAAAH9/fwAKAAAAIgAAABgAAAAAAAAAAAAAAAAAAAAAAAAAAAAAAAAAAAAkAAAAJAAAAAAAAAAHAAAAAAAAAAAAAAAAAAAAAAAAAAAAAAAAAAAAf39/ACUAAABYAAAAAAAAAAAAAAAAAAAAAAAAAAAAAAAAAAAAAAAAAAAAAAAAAAAAAAAAAAAAAAA/AAAAAAAAAKCGAQAAAAAAAAAAAAAAAAAMAAAAAQAAAAAAAAAAAAAAAAAAAB8AAABUAAAAAAAABQAAAAEAAAAAAAAAAAAAAAAAAAAAAAAAAAAAAAAAAAAAAAAAAAAAAAJ/f38AAAAAA8zMzADAwP8Af39/AAAAAAAAAAAAAAAAAAAAAAAAAAAAIQAAABgAAAAUAAAAOAQAALgaAAD4JQAACDQAABAAAAAmAAAACAAAAL2/AAD/HwAA"/>
               </a:ext>
             </a:extLst>
           </p:cNvSpPr>
@@ -697,7 +697,7 @@
             <a:spLocks noGrp="1" noChangeArrowheads="1"/>
             <a:extLst>
               <a:ext uri="smNativeData">
-                <pr:smNativeData xmlns:pr="smNativeData" xmlns="smNativeData" val="SMDATA_15_FUV5ZhMAAAAlAAAACwAAAA0AAAAACAcAADgEAAAoIwAAUBkAAAAAAAAAAAAAAAAAAAEAAABQAAAAAAAAAAAA4D8AAAAAAADgPwAAAAAAAOA/AAAAAAAA4D8AAAAAAADgPwAAAAAAAOA/AAAAAAAA4D8AAAAAAADgPwAAAAAAAOA/AAAAAAAA4D8CAAAAjAAAAAAAAAAAAAAAQoX0DP///wgAAAAAAAAAAAAAAAAAAAAAAAAAAAAAAAAAAAAAZAAAAAEAAABAAAAAAAAAAAAAAAAAAAAAAAAAAAAAAAAAAAAAAAAAAAAAAAAAAAAAAAAAAAAAAAAAAAAAAAAAAAAAAAAAAAAAAAAAAAAAAAAAAAAAAAAAAAAAAAAAAAAAFAAAADwAAAABAAAAAAAAAAAAAAAPAAAAAQAAACMAAAAjAAAAIwAAAB4AAAAAAAAASwAAAEsAAAAAAAAASwAAAEsAAAAVAAAAYAAAAAAAAAAAAAAADwAAACADAAAAAAAAAAAAAAEAAACgMgAAVgcAAKr4//8BAAAAf39/AAEAAABkAAAAAAAAABQAAABAHwAAAAAAACYAAAAAAAAAwOD//wAAAAAmAAAAZAAAABYAAABMAAAAAAAAAAAAAAAEAAAAAAAAAAEAAABZWVkKAAAAACgAAAAoAAAAZAAAAGQAAAAAAAAAzMzMAAAAAABQAAAAUAAAAGQAAABkAAAAAAAAABcAAAAUAAAAAAAAAAAAAAD/fwAA/38AAAAAAAAJAAAABAAAAAAAAAAeAAAAaAAAAAAAAAAAAAAAAAAAAAAAAAAAAAAAECcAABAnAAAAAAAAAAAAAAAAAAAAAAAAAAAAAAAAAAAAAAAAAAAAABQAAAAAAAAAwMD/AAAAAABkAAAAMgAAAAAAAABkAAAAAAAAAH9/fwAKAAAAIgAAABgAAAAAAAAAAAAAAAAAAAAAAAAAAAAAAAAAAAAkAAAAJAAAAAAAAAAHAAAAAAAAAAAAAAAAAAAAAAAAAAAAAAAAAAAAf39/ACUAAABYAAAAAAAAAAAAAAAAAAAAAAAAAAAAAAAAAAAAAAAAAAAAAAAAAAAAAAAAAAAAAAA/AAAAAAAAAKCGAQAAAAAAAAAAAAAAAAAMAAAAAQAAAAAAAAAAAAAAAAAAAB8AAABUAAAAAAAABQAAAAEAAAAAAAAAAAAAAAAAAAAAAAAAAAAAAAAAAAAAAAAAAAAAAAB/f38AAAAAA8zMzADAwP8Af39/AAAAAAAAAAAAAAAAAAAAAAAAAAAAIQAAABgAAAAUAAAACAcAADgEAAAoIwAAUBkAABAAAAAmAAAACAAAAAEPAAAAAAAA"/>
+                <pr:smNativeData xmlns:pr="smNativeData" xmlns="smNativeData" val="SMDATA_15_9kV5ZhMAAAAlAAAACwAAAA0AAAAACAcAADgEAAAoIwAAUBkAAAAAAAAAAAAAAAAAAAEAAABQAAAAAAAAAAAA4D8AAAAAAADgPwAAAAAAAOA/AAAAAAAA4D8AAAAAAADgPwAAAAAAAOA/AAAAAAAA4D8AAAAAAADgPwAAAAAAAOA/AAAAAAAA4D8CAAAAjAAAAAAAAAAAAAAAQoX0DP///wgAAAAAAAAAAAAAAAAAAAAAAAAAAAAAAAAAAAAAZAAAAAEAAABAAAAAAAAAAAAAAAAAAAAAAAAAAAAAAAAAAAAAAAAAAAAAAAAAAAAAAAAAAAAAAAAAAAAAAAAAAAAAAAAAAAAAAAAAAAAAAAAAAAAAAAAAAAAAAAAAAAAAFAAAADwAAAABAAAAAAAAAAAAAAAPAAAAAQAAACMAAAAjAAAAIwAAAB4AAAAAAAAASwAAAEsAAAAAAAAASwAAAEsAAAAVAAAAYAAAAAAAAAAAAAAADwAAACADAAAAAAAAAAAAAAEAAACgMgAAVgcAAKr4//8BAAAAf39/AAEAAABkAAAAAAAAABQAAABAHwAAAAAAACYAAAAAAAAAwOD//wAAAAAmAAAAZAAAABYAAABMAAAAAAAAAAAAAAAEAAAAAAAAAAEAAABZWVkKAAAAACgAAAAoAAAAZAAAAGQAAAAAAAAAzMzMAAAAAABQAAAAUAAAAGQAAABkAAAAAAAAABcAAAAUAAAAAAAAAAAAAAD/fwAA/38AAAAAAAAJAAAABAAAAAAAAAAeAAAAaAAAAAAAAAAAAAAAAAAAAAAAAAAAAAAAECcAABAnAAAAAAAAAAAAAAAAAAAAAAAAAAAAAAAAAAAAAAAAAAAAABQAAAAAAAAAwMD/AAAAAABkAAAAMgAAAAAAAABkAAAAAAAAAH9/fwAKAAAAIgAAABgAAAAAAAAAAAAAAAAAAAAAAAAAAAAAAAAAAAAkAAAAJAAAAAAAAAAHAAAAAAAAAAAAAAAAAAAAAAAAAAAAAAAAAAAAf39/ACUAAABYAAAAAAAAAAAAAAAAAAAAAAAAAAAAAAAAAAAAAAAAAAAAAAAAAAAAAAAAAAAAAAA/AAAAAAAAAKCGAQAAAAAAAAAAAAAAAAAMAAAAAQAAAAAAAAAAAAAAAAAAAB8AAABUAAAAAAAABQAAAAEAAAAAAAAAAAAAAAAAAAAAAAAAAAAAAAAAAAAAAAAAAAAAAAB/f38AAAAAA8zMzADAwP8Af39/AAAAAAAAAAAAAAAAAAAAAAAAAAAAIQAAABgAAAAUAAAACAcAADgEAAAoIwAAUBkAABAAAAAmAAAACAAAAAEPAAAAAAAA"/>
               </a:ext>
             </a:extLst>
           </p:cNvSpPr>
@@ -743,7 +743,7 @@
             <a:spLocks noGrp="1" noChangeArrowheads="1"/>
             <a:extLst>
               <a:ext uri="smNativeData">
-                <pr:smNativeData xmlns:pr="smNativeData" xmlns="smNativeData" val="SMDATA_15_FUV5ZhMAAAAlAAAAZAAAAA0AAAAAkAAAAJAAAACQAAAAkAAAAAAAAAAAAAAAAAAAAAEAAABQAAAAAAAAAAAA4D8AAAAAAADgPwAAAAAAAOA/AAAAAAAA4D8AAAAAAADgPwAAAAAAAOA/AAAAAAAA4D8AAAAAAADgPwAAAAAAAOA/AAAAAAAA4D8CAAAAjAAAAAAAAAAAAAAAQoX0DP///wgAAAAAAAAAAAAAAAAAAAAAAAAAAAAAAAAAAAAAZAAAAAEAAABAAAAAAAAAAAAAAAAAAAAAAAAAAAAAAAAAAAAAAAAAAAAAAAAAAAAAAAAAAAAAAAAAAAAAAAAAAAAAAAAAAAAAAAAAAAAAAAAAAAAAAAAAAAAAAAAAAAAAFAAAADwAAAAAAAAAAAAAAAAAAAkUAAAAAQAAABQAAAAUAAAAFAAAAAEAAAAAAAAAZAAAAGQAAAAAAAAAZAAAAGQAAAAVAAAAYAAAAAAAAAAAAAAADwAAACADAAAAAAAAAAAAAAEAAACgMgAAVgcAAKr4//8BAAAAf39/AAEAAABkAAAAAAAAABQAAABAHwAAAAAAACYAAAAAAAAAwOD//wAAAAAmAAAAZAAAABYAAABMAAAAAAAAAAAAAAAEAAAAAAAAAAEAAABZWVkKAAAAACgAAAAoAAAAZAAAAGQAAAAAAAAAzMzMAAAAAABQAAAAUAAAAGQAAABkAAAAAAAAABcAAAAUAAAAAAAAAAAAAAD/fwAA/38AAAAAAAAJAAAABAAAAAAAAAAeAAAAaAAAAAAAAAAAAAAAAAAAAAAAAAAAAAAAECcAABAnAAAAAAAAAAAAAAAAAAAAAAAAAAAAAAAAAAAAAAAAAAAAABQAAAAAAAAAwMD/AAAAAABkAAAAMgAAAAAAAABkAAAAAAAAAH9/fwAKAAAAIgAAABgAAAAAAAAAAAAAAAAAAAAAAAAAAAAAAAAAAAAkAAAAJAAAAAAAAAAHAAAAAAAAAAAAAAAAAAAAAAAAAAAAAAAAAAAAf39/ACUAAABYAAAAAAAAAAAAAAAAAAAAAAAAAAAAAAAAAAAAAAAAAAAAAAAAAAAAAAAAAAAAAAA/AAAAAAAAAKCGAQAAAAAAAAAAAAAAAAAMAAAAAQAAAAAAAAAAAAAAAAAAAB8AAABUAAAAAAAABQAAAAEAAAAAAAAAAAAAAAAAAAAAAAAAAAAAAAAAAAAAAAAAAAAAAAJ/f38AAAAAA8zMzADAwP8Af39/AAAAAAAAAAAAAAAAAAAAAAAAAAAAIQAAABgAAAAUAAAAOAQAALgaAAD4JQAACDQAABAAAAAmAAAACAAAAL0/AAAAAAAA"/>
+                <pr:smNativeData xmlns:pr="smNativeData" xmlns="smNativeData" val="SMDATA_15_9kV5ZhMAAAAlAAAAZAAAAA0AAAAAkAAAAJAAAACQAAAAkAAAAAAAAAAAAAAAAAAAAAEAAABQAAAAAAAAAAAA4D8AAAAAAADgPwAAAAAAAOA/AAAAAAAA4D8AAAAAAADgPwAAAAAAAOA/AAAAAAAA4D8AAAAAAADgPwAAAAAAAOA/AAAAAAAA4D8CAAAAjAAAAAAAAAAAAAAAQoX0DP///wgAAAAAAAAAAAAAAAAAAAAAAAAAAAAAAAAAAAAAZAAAAAEAAABAAAAAAAAAAAAAAAAAAAAAAAAAAAAAAAAAAAAAAAAAAAAAAAAAAAAAAAAAAAAAAAAAAAAAAAAAAAAAAAAAAAAAAAAAAAAAAAAAAAAAAAAAAAAAAAAAAAAAFAAAADwAAAAAAAAAAAAAAAAAAAkUAAAAAQAAABQAAAAUAAAAFAAAAAEAAAAAAAAAZAAAAGQAAAAAAAAAZAAAAGQAAAAVAAAAYAAAAAAAAAAAAAAADwAAACADAAAAAAAAAAAAAAEAAACgMgAAVgcAAKr4//8BAAAAf39/AAEAAABkAAAAAAAAABQAAABAHwAAAAAAACYAAAAAAAAAwOD//wAAAAAmAAAAZAAAABYAAABMAAAAAAAAAAAAAAAEAAAAAAAAAAEAAABZWVkKAAAAACgAAAAoAAAAZAAAAGQAAAAAAAAAzMzMAAAAAABQAAAAUAAAAGQAAABkAAAAAAAAABcAAAAUAAAAAAAAAAAAAAD/fwAA/38AAAAAAAAJAAAABAAAAAAAAAAeAAAAaAAAAAAAAAAAAAAAAAAAAAAAAAAAAAAAECcAABAnAAAAAAAAAAAAAAAAAAAAAAAAAAAAAAAAAAAAAAAAAAAAABQAAAAAAAAAwMD/AAAAAABkAAAAMgAAAAAAAABkAAAAAAAAAH9/fwAKAAAAIgAAABgAAAAAAAAAAAAAAAAAAAAAAAAAAAAAAAAAAAAkAAAAJAAAAAAAAAAHAAAAAAAAAAAAAAAAAAAAAAAAAAAAAAAAAAAAf39/ACUAAABYAAAAAAAAAAAAAAAAAAAAAAAAAAAAAAAAAAAAAAAAAAAAAAAAAAAAAAAAAAAAAAA/AAAAAAAAAKCGAQAAAAAAAAAAAAAAAAAMAAAAAQAAAAAAAAAAAAAAAAAAAB8AAABUAAAAAAAABQAAAAEAAAAAAAAAAAAAAAAAAAAAAAAAAAAAAAAAAAAAAAAAAAAAAAJ/f38AAAAAA8zMzADAwP8Af39/AAAAAAAAAAAAAAAAAAAAAAAAAAAAIQAAABgAAAAUAAAAOAQAALgaAAD4JQAACDQAABAAAAAmAAAACAAAAL0/AAAAAAAA"/>
               </a:ext>
             </a:extLst>
           </p:cNvSpPr>
@@ -820,7 +820,7 @@
             <a:spLocks noGrp="1" noChangeArrowheads="1"/>
             <a:extLst>
               <a:ext uri="smNativeData">
-                <pr:smNativeData xmlns:pr="smNativeData" xmlns="smNativeData" val="SMDATA_15_FUV5ZhMAAAAlAAAACwAAAA0AAAAACAcAADgEAAAoIwAAUBkAAAAAAAAAAAAAAAAAAAEAAABQAAAAAAAAAAAA4D8AAAAAAADgPwAAAAAAAOA/AAAAAAAA4D8AAAAAAADgPwAAAAAAAOA/AAAAAAAA4D8AAAAAAADgPwAAAAAAAOA/AAAAAAAA4D8CAAAAjAAAAAAAAAAAAAAAQoX0DP///wgAAAAAAAAAAAAAAAAAAAAAAAAAAAAAAAAAAAAAZAAAAAEAAABAAAAAAAAAAAAAAAAAAAAAAAAAAAAAAAAAAAAAAAAAAAAAAAAAAAAAAAAAAAAAAAAAAAAAAAAAAAAAAAAAAAAAAAAAAAAAAAAAAAAAAAAAAAAAAAAAAAAAFAAAADwAAAABAAAAAAAAAAAAAAAPAAAAAQAAACMAAAAjAAAAIwAAAB4AAAAAAAAASwAAAEsAAAAAAAAASwAAAEsAAAAVAAAAYAAAAAAAAAAAAAAADwAAACADAAAAAAAAAAAAAAEAAACgMgAAVgcAAKr4//8BAAAAf39/AAEAAABkAAAAAAAAABQAAABAHwAAAAAAACYAAAAAAAAAwOD//wAAAAAmAAAAZAAAABYAAABMAAAAAAAAAAAAAAAEAAAAAAAAAAEAAABZWVkKAAAAACgAAAAoAAAAZAAAAGQAAAAAAAAAzMzMAAAAAABQAAAAUAAAAGQAAABkAAAAAAAAABcAAAAUAAAAAAAAAAAAAAD/fwAA/38AAAAAAAAJAAAABAAAALQAAAAeAAAAaAAAAAAAAAAAAAAAAAAAAAAAAAAAAAAAECcAABAnAAAAAAAAAAAAAAAAAAAAAAAAAAAAAAAAAAAAAAAAAAAAABQAAAAAAAAAwMD/AAAAAABkAAAAMgAAAAAAAABkAAAAAAAAAH9/fwAKAAAAIgAAABgAAAAAAAAAAAAAAAAAAAAAAAAAAAAAAAAAAAAkAAAAJAAAAAAAAAAHAAAAAAAAAAAAAAAAAAAAAAAAAAAAAAAAAAAAf39/ACUAAABYAAAAAAAAAAAAAAAAAAAAAAAAAAAAAAAAAAAAAAAAAAAAAAAAAAAAAAAAAAAAAAA/AAAAAAAAAKCGAQAAAAAAAAAAAAAAAAAMAAAAAQAAAAAAAAAAAAAAAAAAAB8AAABUAAAAAAAABQAAAAEAAAAAAAAAAAAAAAAAAAAAAAAAAAAAAAAAAAAAAAAAAAAAAAB/f38AAAAAA8zMzADAwP8Af39/AAAAAAAAAAAAAAAAAAAAAAAAAAAAIQAAABgAAAAUAAAACAcAADgEAAAoIwAAUBkAABAAAAAmAAAACAAAAAEPAAAAAAAA"/>
+                <pr:smNativeData xmlns:pr="smNativeData" xmlns="smNativeData" val="SMDATA_15_9kV5ZhMAAAAlAAAACwAAAA0AAAAACAcAADgEAAAoIwAAUBkAAAAAAAAAAAAAAAAAAAEAAABQAAAAAAAAAAAA4D8AAAAAAADgPwAAAAAAAOA/AAAAAAAA4D8AAAAAAADgPwAAAAAAAOA/AAAAAAAA4D8AAAAAAADgPwAAAAAAAOA/AAAAAAAA4D8CAAAAjAAAAAAAAAAAAAAAQoX0DP///wgAAAAAAAAAAAAAAAAAAAAAAAAAAAAAAAAAAAAAZAAAAAEAAABAAAAAAAAAAAAAAAAAAAAAAAAAAAAAAAAAAAAAAAAAAAAAAAAAAAAAAAAAAAAAAAAAAAAAAAAAAAAAAAAAAAAAAAAAAAAAAAAAAAAAAAAAAAAAAAAAAAAAFAAAADwAAAABAAAAAAAAAAAAAAAPAAAAAQAAACMAAAAjAAAAIwAAAB4AAAAAAAAASwAAAEsAAAAAAAAASwAAAEsAAAAVAAAAYAAAAAAAAAAAAAAADwAAACADAAAAAAAAAAAAAAEAAACgMgAAVgcAAKr4//8BAAAAf39/AAEAAABkAAAAAAAAABQAAABAHwAAAAAAACYAAAAAAAAAwOD//wAAAAAmAAAAZAAAABYAAABMAAAAAAAAAAAAAAAEAAAAAAAAAAEAAABZWVkKAAAAACgAAAAoAAAAZAAAAGQAAAAAAAAAzMzMAAAAAABQAAAAUAAAAGQAAABkAAAAAAAAABcAAAAUAAAAAAAAAAAAAAD/fwAA/38AAAAAAAAJAAAABAAAALQAAAAeAAAAaAAAAAAAAAAAAAAAAAAAAAAAAAAAAAAAECcAABAnAAAAAAAAAAAAAAAAAAAAAAAAAAAAAAAAAAAAAAAAAAAAABQAAAAAAAAAwMD/AAAAAABkAAAAMgAAAAAAAABkAAAAAAAAAH9/fwAKAAAAIgAAABgAAAAAAAAAAAAAAAAAAAAAAAAAAAAAAAAAAAAkAAAAJAAAAAAAAAAHAAAAAAAAAAAAAAAAAAAAAAAAAAAAAAAAAAAAf39/ACUAAABYAAAAAAAAAAAAAAAAAAAAAAAAAAAAAAAAAAAAAAAAAAAAAAAAAAAAAAAAAAAAAAA/AAAAAAAAAKCGAQAAAAAAAAAAAAAAAAAMAAAAAQAAAAAAAAAAAAAAAAAAAB8AAABUAAAAAAAABQAAAAEAAAAAAAAAAAAAAAAAAAAAAAAAAAAAAAAAAAAAAAAAAAAAAAB/f38AAAAAA8zMzADAwP8Af39/AAAAAAAAAAAAAAAAAAAAAAAAAAAAIQAAABgAAAAUAAAACAcAADgEAAAoIwAAUBkAABAAAAAmAAAACAAAAAEPAAAAAAAA"/>
               </a:ext>
             </a:extLst>
           </p:cNvSpPr>
@@ -866,7 +866,7 @@
             <a:spLocks noGrp="1" noChangeArrowheads="1"/>
             <a:extLst>
               <a:ext uri="smNativeData">
-                <pr:smNativeData xmlns:pr="smNativeData" xmlns="smNativeData" val="SMDATA_15_FUV5ZhMAAAAlAAAAZAAAAA0AAAAAkAAAAJAAAACQAAAAkAAAAAAAAAAAAAAAAAAAAAEAAABQAAAAAAAAAAAA4D8AAAAAAADgPwAAAAAAAOA/AAAAAAAA4D8AAAAAAADgPwAAAAAAAOA/AAAAAAAA4D8AAAAAAADgPwAAAAAAAOA/AAAAAAAA4D8CAAAAjAAAAAAAAAAAAAAAQoX0DP///wgAAAAAAAAAAAAAAAAAAAAAAAAAAAAAAAAAAAAAZAAAAAEAAABAAAAAAAAAAAAAAAAAAAAAAAAAAAAAAAAAAAAAAAAAAAAAAAAAAAAAAAAAAAAAAAAAAAAAAAAAAAAAAAAAAAAAAAAAAAAAAAAAAAAAAAAAAAAAAAAAAAAAFAAAADwAAAAAAAAAAAAAAAAAAAkUAAAAAQAAABQAAAAUAAAAFAAAAAEAAAAAAAAAZAAAAGQAAAAAAAAAZAAAAGQAAAAVAAAAYAAAAAAAAAAAAAAADwAAACADAAAAAAAAAAAAAAEAAACgMgAAVgcAAKr4//8BAAAAf39/AAEAAABkAAAAAAAAABQAAABAHwAAAAAAACYAAAAAAAAAwOD//wAAAAAmAAAAZAAAABYAAABMAAAAAAAAAAAAAAAEAAAAAAAAAAEAAABZWVkKAAAAACgAAAAoAAAAZAAAAGQAAAAAAAAAzMzMAAAAAABQAAAAUAAAAGQAAABkAAAAAAAAABcAAAAUAAAAAAAAAAAAAAD/fwAA/38AAAAAAAAJAAAABAAAAIK8UsUeAAAAaAAAAAAAAAAAAAAAAAAAAAAAAAAAAAAAECcAABAnAAAAAAAAAAAAAAAAAAAAAAAAAAAAAAAAAAAAAAAAAAAAABQAAAAAAAAAwMD/AAAAAABkAAAAMgAAAAAAAABkAAAAAAAAAH9/fwAKAAAAIgAAABgAAAAAAAAAAAAAAAAAAAAAAAAAAAAAAAAAAAAkAAAAJAAAAAAAAAAHAAAAAAAAAAAAAAAAAAAAAAAAAAAAAAAAAAAAf39/ACUAAABYAAAAAAAAAAAAAAAAAAAAAAAAAAAAAAAAAAAAAAAAAAAAAAAAAAAAAAAAAAAAAAA/AAAAAAAAAKCGAQAAAAAAAAAAAAAAAAAMAAAAAQAAAAAAAAAAAAAAAAAAAB8AAABUAAAAAAAABQAAAAEAAAAAAAAAAAAAAAAAAAAAAAAAAAAAAAAAAAAAAAAAAAAAAAJ/f38AAAAAA8zMzADAwP8Af39/AAAAAAAAAAAAAAAAAAAAAAAAAAAAIQAAABgAAAAUAAAAOAQAALgaAAD4JQAACDQAABAAAAAmAAAACAAAAL0/AAAAAAAA"/>
+                <pr:smNativeData xmlns:pr="smNativeData" xmlns="smNativeData" val="SMDATA_15_9kV5ZhMAAAAlAAAAZAAAAA0AAAAAkAAAAJAAAACQAAAAkAAAAAAAAAAAAAAAAAAAAAEAAABQAAAAAAAAAAAA4D8AAAAAAADgPwAAAAAAAOA/AAAAAAAA4D8AAAAAAADgPwAAAAAAAOA/AAAAAAAA4D8AAAAAAADgPwAAAAAAAOA/AAAAAAAA4D8CAAAAjAAAAAAAAAAAAAAAQoX0DP///wgAAAAAAAAAAAAAAAAAAAAAAAAAAAAAAAAAAAAAZAAAAAEAAABAAAAAAAAAAAAAAAAAAAAAAAAAAAAAAAAAAAAAAAAAAAAAAAAAAAAAAAAAAAAAAAAAAAAAAAAAAAAAAAAAAAAAAAAAAAAAAAAAAAAAAAAAAAAAAAAAAAAAFAAAADwAAAAAAAAAAAAAAAAAAAkUAAAAAQAAABQAAAAUAAAAFAAAAAEAAAAAAAAAZAAAAGQAAAAAAAAAZAAAAGQAAAAVAAAAYAAAAAAAAAAAAAAADwAAACADAAAAAAAAAAAAAAEAAACgMgAAVgcAAKr4//8BAAAAf39/AAEAAABkAAAAAAAAABQAAABAHwAAAAAAACYAAAAAAAAAwOD//wAAAAAmAAAAZAAAABYAAABMAAAAAAAAAAAAAAAEAAAAAAAAAAEAAABZWVkKAAAAACgAAAAoAAAAZAAAAGQAAAAAAAAAzMzMAAAAAABQAAAAUAAAAGQAAABkAAAAAAAAABcAAAAUAAAAAAAAAAAAAAD/fwAA/38AAAAAAAAJAAAABAAAAIK8UsUeAAAAaAAAAAAAAAAAAAAAAAAAAAAAAAAAAAAAECcAABAnAAAAAAAAAAAAAAAAAAAAAAAAAAAAAAAAAAAAAAAAAAAAABQAAAAAAAAAwMD/AAAAAABkAAAAMgAAAAAAAABkAAAAAAAAAH9/fwAKAAAAIgAAABgAAAAAAAAAAAAAAAAAAAAAAAAAAAAAAAAAAAAkAAAAJAAAAAAAAAAHAAAAAAAAAAAAAAAAAAAAAAAAAAAAAAAAAAAAf39/ACUAAABYAAAAAAAAAAAAAAAAAAAAAAAAAAAAAAAAAAAAAAAAAAAAAAAAAAAAAAAAAAAAAAA/AAAAAAAAAKCGAQAAAAAAAAAAAAAAAAAMAAAAAQAAAAAAAAAAAAAAAAAAAB8AAABUAAAAAAAABQAAAAEAAAAAAAAAAAAAAAAAAAAAAAAAAAAAAAAAAAAAAAAAAAAAAAJ/f38AAAAAA8zMzADAwP8Af39/AAAAAAAAAAAAAAAAAAAAAAAAAAAAIQAAABgAAAAUAAAAOAQAALgaAAD4JQAACDQAABAAAAAmAAAACAAAAL0/AAAAAAAA"/>
               </a:ext>
             </a:extLst>
           </p:cNvSpPr>
@@ -943,7 +943,7 @@
             <a:spLocks noGrp="1" noChangeArrowheads="1"/>
             <a:extLst>
               <a:ext uri="smNativeData">
-                <pr:smNativeData xmlns:pr="smNativeData" xmlns="smNativeData" val="SMDATA_15_FUV5ZhMAAAAlAAAACwAAAA0AAAAACAcAADgEAAAoIwAAUBkAAAAAAAAAAAAAAAAAAAEAAABQAAAAAAAAAAAA4D8AAAAAAADgPwAAAAAAAOA/AAAAAAAA4D8AAAAAAADgPwAAAAAAAOA/AAAAAAAA4D8AAAAAAADgPwAAAAAAAOA/AAAAAAAA4D8CAAAAjAAAAAAAAAAAAAAAQoX0DP///wgAAAAAAAAAAAAAAAAAAAAAAAAAAAAAAAAAAAAAZAAAAAEAAABAAAAAAAAAAAAAAAAAAAAAAAAAAAAAAAAAAAAAAAAAAAAAAAAAAAAAAAAAAAAAAAAAAAAAAAAAAAAAAAAAAAAAAAAAAAAAAAAAAAAAAAAAAAAAAAAAAAAAFAAAADwAAAABAAAAAAAAAAAAAAAPAAAAAQAAACMAAAAjAAAAIwAAAB4AAAAAAAAASwAAAEsAAAAAAAAASwAAAEsAAAAVAAAAYAAAAAAAAAAAAAAADwAAACADAAAAAAAAAAAAAAEAAACgMgAAVgcAAKr4//8BAAAAf39/AAEAAABkAAAAAAAAABQAAABAHwAAAAAAACYAAAAAAAAAwOD//wAAAAAmAAAAZAAAABYAAABMAAAAAAAAAAAAAAAEAAAAAAAAAAEAAABZWVkKAAAAACgAAAAoAAAAZAAAAGQAAAAAAAAAzMzMAAAAAABQAAAAUAAAAGQAAABkAAAAAAAAABcAAAAUAAAAAAAAAAAAAAD/fwAA/38AAAAAAAAJAAAABAAAAAAAAAAeAAAAaAAAAAAAAAAAAAAAAAAAAAAAAAAAAAAAECcAABAnAAAAAAAAAAAAAAAAAAAAAAAAAAAAAAAAAAAAAAAAAAAAABQAAAAAAAAAwMD/AAAAAABkAAAAMgAAAAAAAABkAAAAAAAAAH9/fwAKAAAAIgAAABgAAAAAAAAAAAAAAAAAAAAAAAAAAAAAAAAAAAAkAAAAJAAAAAAAAAAHAAAAAAAAAAAAAAAAAAAAAAAAAAAAAAAAAAAAf39/ACUAAABYAAAAAAAAAAAAAAAAAAAAAAAAAAAAAAAAAAAAAAAAAAAAAAAAAAAAAAAAAAAAAAA/AAAAAAAAAKCGAQAAAAAAAAAAAAAAAAAMAAAAAQAAAAAAAAAAAAAAAAAAAB8AAABUAAAAAAAABQAAAAEAAAAAAAAAAAAAAAAAAAAAAAAAAAAAAAAAAAAAAAAAAAAAAAB/f38AAAAAA8zMzADAwP8Af39/AAAAAAAAAAAAAAAAAAAAAAAAAAAAIQAAABgAAAAUAAAACAcAADgEAAAoIwAAUBkAABAAAAAmAAAACAAAAAEPAAAAAAAA"/>
+                <pr:smNativeData xmlns:pr="smNativeData" xmlns="smNativeData" val="SMDATA_15_9kV5ZhMAAAAlAAAACwAAAA0AAAAACAcAADgEAAAoIwAAUBkAAAAAAAAAAAAAAAAAAAEAAABQAAAAAAAAAAAA4D8AAAAAAADgPwAAAAAAAOA/AAAAAAAA4D8AAAAAAADgPwAAAAAAAOA/AAAAAAAA4D8AAAAAAADgPwAAAAAAAOA/AAAAAAAA4D8CAAAAjAAAAAAAAAAAAAAAQoX0DP///wgAAAAAAAAAAAAAAAAAAAAAAAAAAAAAAAAAAAAAZAAAAAEAAABAAAAAAAAAAAAAAAAAAAAAAAAAAAAAAAAAAAAAAAAAAAAAAAAAAAAAAAAAAAAAAAAAAAAAAAAAAAAAAAAAAAAAAAAAAAAAAAAAAAAAAAAAAAAAAAAAAAAAFAAAADwAAAABAAAAAAAAAAAAAAAPAAAAAQAAACMAAAAjAAAAIwAAAB4AAAAAAAAASwAAAEsAAAAAAAAASwAAAEsAAAAVAAAAYAAAAAAAAAAAAAAADwAAACADAAAAAAAAAAAAAAEAAACgMgAAVgcAAKr4//8BAAAAf39/AAEAAABkAAAAAAAAABQAAABAHwAAAAAAACYAAAAAAAAAwOD//wAAAAAmAAAAZAAAABYAAABMAAAAAAAAAAAAAAAEAAAAAAAAAAEAAABZWVkKAAAAACgAAAAoAAAAZAAAAGQAAAAAAAAAzMzMAAAAAABQAAAAUAAAAGQAAABkAAAAAAAAABcAAAAUAAAAAAAAAAAAAAD/fwAA/38AAAAAAAAJAAAABAAAAAAAAAAeAAAAaAAAAAAAAAAAAAAAAAAAAAAAAAAAAAAAECcAABAnAAAAAAAAAAAAAAAAAAAAAAAAAAAAAAAAAAAAAAAAAAAAABQAAAAAAAAAwMD/AAAAAABkAAAAMgAAAAAAAABkAAAAAAAAAH9/fwAKAAAAIgAAABgAAAAAAAAAAAAAAAAAAAAAAAAAAAAAAAAAAAAkAAAAJAAAAAAAAAAHAAAAAAAAAAAAAAAAAAAAAAAAAAAAAAAAAAAAf39/ACUAAABYAAAAAAAAAAAAAAAAAAAAAAAAAAAAAAAAAAAAAAAAAAAAAAAAAAAAAAAAAAAAAAA/AAAAAAAAAKCGAQAAAAAAAAAAAAAAAAAMAAAAAQAAAAAAAAAAAAAAAAAAAB8AAABUAAAAAAAABQAAAAEAAAAAAAAAAAAAAAAAAAAAAAAAAAAAAAAAAAAAAAAAAAAAAAB/f38AAAAAA8zMzADAwP8Af39/AAAAAAAAAAAAAAAAAAAAAAAAAAAAIQAAABgAAAAUAAAACAcAADgEAAAoIwAAUBkAABAAAAAmAAAACAAAAAEPAAAAAAAA"/>
               </a:ext>
             </a:extLst>
           </p:cNvSpPr>
@@ -989,7 +989,7 @@
             <a:spLocks noGrp="1" noChangeArrowheads="1"/>
             <a:extLst>
               <a:ext uri="smNativeData">
-                <pr:smNativeData xmlns:pr="smNativeData" xmlns="smNativeData" val="SMDATA_15_FUV5ZhMAAAAlAAAAZAAAAA0AAAAAkAAAAJAAAACQAAAAkAAAAAAAAAAAAAAAAAAAAAEAAABQAAAAAAAAAAAA4D8AAAAAAADgPwAAAAAAAOA/AAAAAAAA4D8AAAAAAADgPwAAAAAAAOA/AAAAAAAA4D8AAAAAAADgPwAAAAAAAOA/AAAAAAAA4D8CAAAAjAAAAAAAAAAAAAAAQoX0DP///wgAAAAAAAAAAAAAAAAAAAAAAAAAAAAAAAAAAAAAZAAAAAEAAABAAAAAAAAAAAAAAAAAAAAAAAAAAAAAAAAAAAAAAAAAAAAAAAAAAAAAAAAAAAAAAAAAAAAAAAAAAAAAAAAAAAAAAAAAAAAAAAAAAAAAAAAAAAAAAAAAAAAAFAAAADwAAAAAAAAAAAAAAAAAAAkUAAAAAQAAABQAAAAUAAAAFAAAAAEAAAAAAAAAZAAAAGQAAAAAAAAAZAAAAGQAAAAVAAAAYAAAAAAAAAAAAAAADwAAACADAAAAAAAAAAAAAAEAAACgMgAAVgcAAKr4//8BAAAAf39/AAEAAABkAAAAAAAAABQAAABAHwAAAAAAACYAAAAAAAAAwOD//wAAAAAmAAAAZAAAABYAAABMAAAAAAAAAAAAAAAEAAAAAAAAAAEAAABZWVkKAAAAACgAAAAoAAAAZAAAAGQAAAAAAAAAzMzMAAAAAABQAAAAUAAAAGQAAABkAAAAAAAAABcAAAAUAAAAAAAAAAAAAAD/fwAA/38AAAAAAAAJAAAABAAAAMGa1cUeAAAAaAAAAAAAAAAAAAAAAAAAAAAAAAAAAAAAECcAABAnAAAAAAAAAAAAAAAAAAAAAAAAAAAAAAAAAAAAAAAAAAAAABQAAAAAAAAAwMD/AAAAAABkAAAAMgAAAAAAAABkAAAAAAAAAH9/fwAKAAAAIgAAABgAAAAAAAAAAAAAAAAAAAAAAAAAAAAAAAAAAAAkAAAAJAAAAAAAAAAHAAAAAAAAAAAAAAAAAAAAAAAAAAAAAAAAAAAAf39/ACUAAABYAAAAAAAAAAAAAAAAAAAAAAAAAAAAAAAAAAAAAAAAAAAAAAAAAAAAAAAAAAAAAAA/AAAAAAAAAKCGAQAAAAAAAAAAAAAAAAAMAAAAAQAAAAAAAAAAAAAAAAAAAB8AAABUAAAAAAAABQAAAAEAAAAAAAAAAAAAAAAAAAAAAAAAAAAAAAAAAAAAAAAAAAAAAAJ/f38AAAAAA8zMzADAwP8Af39/AAAAAAAAAAAAAAAAAAAAAAAAAAAAIQAAABgAAAAUAAAAOAQAALgaAAD4JQAACDQAABAAAAAmAAAACAAAAL0/AAAAAAAA"/>
+                <pr:smNativeData xmlns:pr="smNativeData" xmlns="smNativeData" val="SMDATA_15_9kV5ZhMAAAAlAAAAZAAAAA0AAAAAkAAAAJAAAACQAAAAkAAAAAAAAAAAAAAAAAAAAAEAAABQAAAAAAAAAAAA4D8AAAAAAADgPwAAAAAAAOA/AAAAAAAA4D8AAAAAAADgPwAAAAAAAOA/AAAAAAAA4D8AAAAAAADgPwAAAAAAAOA/AAAAAAAA4D8CAAAAjAAAAAAAAAAAAAAAQoX0DP///wgAAAAAAAAAAAAAAAAAAAAAAAAAAAAAAAAAAAAAZAAAAAEAAABAAAAAAAAAAAAAAAAAAAAAAAAAAAAAAAAAAAAAAAAAAAAAAAAAAAAAAAAAAAAAAAAAAAAAAAAAAAAAAAAAAAAAAAAAAAAAAAAAAAAAAAAAAAAAAAAAAAAAFAAAADwAAAAAAAAAAAAAAAAAAAkUAAAAAQAAABQAAAAUAAAAFAAAAAEAAAAAAAAAZAAAAGQAAAAAAAAAZAAAAGQAAAAVAAAAYAAAAAAAAAAAAAAADwAAACADAAAAAAAAAAAAAAEAAACgMgAAVgcAAKr4//8BAAAAf39/AAEAAABkAAAAAAAAABQAAABAHwAAAAAAACYAAAAAAAAAwOD//wAAAAAmAAAAZAAAABYAAABMAAAAAAAAAAAAAAAEAAAAAAAAAAEAAABZWVkKAAAAACgAAAAoAAAAZAAAAGQAAAAAAAAAzMzMAAAAAABQAAAAUAAAAGQAAABkAAAAAAAAABcAAAAUAAAAAAAAAAAAAAD/fwAA/38AAAAAAAAJAAAABAAAAMGa1cUeAAAAaAAAAAAAAAAAAAAAAAAAAAAAAAAAAAAAECcAABAnAAAAAAAAAAAAAAAAAAAAAAAAAAAAAAAAAAAAAAAAAAAAABQAAAAAAAAAwMD/AAAAAABkAAAAMgAAAAAAAABkAAAAAAAAAH9/fwAKAAAAIgAAABgAAAAAAAAAAAAAAAAAAAAAAAAAAAAAAAAAAAAkAAAAJAAAAAAAAAAHAAAAAAAAAAAAAAAAAAAAAAAAAAAAAAAAAAAAf39/ACUAAABYAAAAAAAAAAAAAAAAAAAAAAAAAAAAAAAAAAAAAAAAAAAAAAAAAAAAAAAAAAAAAAA/AAAAAAAAAKCGAQAAAAAAAAAAAAAAAAAMAAAAAQAAAAAAAAAAAAAAAAAAAB8AAABUAAAAAAAABQAAAAEAAAAAAAAAAAAAAAAAAAAAAAAAAAAAAAAAAAAAAAAAAAAAAAJ/f38AAAAAA8zMzADAwP8Af39/AAAAAAAAAAAAAAAAAAAAAAAAAAAAIQAAABgAAAAUAAAAOAQAALgaAAD4JQAACDQAABAAAAAmAAAACAAAAL0/AAAAAAAA"/>
               </a:ext>
             </a:extLst>
           </p:cNvSpPr>
@@ -1066,7 +1066,7 @@
             <a:spLocks noGrp="1" noChangeArrowheads="1"/>
             <a:extLst>
               <a:ext uri="smNativeData">
-                <pr:smNativeData xmlns:pr="smNativeData" xmlns="smNativeData" val="SMDATA_15_FUV5ZhMAAAAlAAAACwAAAA0AAAAACAcAADgEAAAoIwAAUBkAAAAAAAAAAAAAAAAAAAEAAABQAAAAAAAAAAAA4D8AAAAAAADgPwAAAAAAAOA/AAAAAAAA4D8AAAAAAADgPwAAAAAAAOA/AAAAAAAA4D8AAAAAAADgPwAAAAAAAOA/AAAAAAAA4D8CAAAAjAAAAAAAAAAAAAAAQoX0DP///wgAAAAAAAAAAAAAAAAAAAAAAAAAAAAAAAAAAAAAZAAAAAEAAABAAAAAAAAAAAAAAAAAAAAAAAAAAAAAAAAAAAAAAAAAAAAAAAAAAAAAAAAAAAAAAAAAAAAAAAAAAAAAAAAAAAAAAAAAAAAAAAAAAAAAAAAAAAAAAAAAAAAAFAAAADwAAAABAAAAAAAAAAAAAAAPAAAAAQAAACMAAAAjAAAAIwAAAB4AAAAAAAAASwAAAEsAAAAAAAAASwAAAEsAAAAVAAAAYAAAAAAAAAAAAAAADwAAACADAAAAAAAAAAAAAAEAAACgMgAAVgcAAKr4//8BAAAAf39/AAEAAABkAAAAAAAAABQAAABAHwAAAAAAACYAAAAAAAAAwOD//wAAAAAmAAAAZAAAABYAAABMAAAAAAAAAAAAAAAEAAAAAAAAAAEAAABZWVkKAAAAACgAAAAoAAAAZAAAAGQAAAAAAAAAzMzMAAAAAABQAAAAUAAAAGQAAABkAAAAAAAAABcAAAAUAAAAAAAAAAAAAAD/fwAA/38AAAAAAAAJAAAABAAAAAAAAAAeAAAAaAAAAAAAAAAAAAAAAAAAAAAAAAAAAAAAECcAABAnAAAAAAAAAAAAAAAAAAAAAAAAAAAAAAAAAAAAAAAAAAAAABQAAAAAAAAAwMD/AAAAAABkAAAAMgAAAAAAAABkAAAAAAAAAH9/fwAKAAAAIgAAABgAAAAAAAAAAAAAAAAAAAAAAAAAAAAAAAAAAAAkAAAAJAAAAAAAAAAHAAAAAAAAAAAAAAAAAAAAAAAAAAAAAAAAAAAAf39/ACUAAABYAAAAAAAAAAAAAAAAAAAAAAAAAAAAAAAAAAAAAAAAAAAAAAAAAAAAAAAAAAAAAAA/AAAAAAAAAKCGAQAAAAAAAAAAAAAAAAAMAAAAAQAAAAAAAAAAAAAAAAAAAB8AAABUAAAAAAAABQAAAAEAAAAAAAAAAAAAAAAAAAAAAAAAAAAAAAAAAAAAAAAAAAAAAAB/f38AAAAAA8zMzADAwP8Af39/AAAAAAAAAAAAAAAAAAAAAAAAAAAAIQAAABgAAAAUAAAACAcAADgEAAAoIwAAUBkAABAAAAAmAAAACAAAAAEPAAAAAAAA"/>
+                <pr:smNativeData xmlns:pr="smNativeData" xmlns="smNativeData" val="SMDATA_15_9kV5ZhMAAAAlAAAACwAAAA0AAAAACAcAADgEAAAoIwAAUBkAAAAAAAAAAAAAAAAAAAEAAABQAAAAAAAAAAAA4D8AAAAAAADgPwAAAAAAAOA/AAAAAAAA4D8AAAAAAADgPwAAAAAAAOA/AAAAAAAA4D8AAAAAAADgPwAAAAAAAOA/AAAAAAAA4D8CAAAAjAAAAAAAAAAAAAAAQoX0DP///wgAAAAAAAAAAAAAAAAAAAAAAAAAAAAAAAAAAAAAZAAAAAEAAABAAAAAAAAAAAAAAAAAAAAAAAAAAAAAAAAAAAAAAAAAAAAAAAAAAAAAAAAAAAAAAAAAAAAAAAAAAAAAAAAAAAAAAAAAAAAAAAAAAAAAAAAAAAAAAAAAAAAAFAAAADwAAAABAAAAAAAAAAAAAAAPAAAAAQAAACMAAAAjAAAAIwAAAB4AAAAAAAAASwAAAEsAAAAAAAAASwAAAEsAAAAVAAAAYAAAAAAAAAAAAAAADwAAACADAAAAAAAAAAAAAAEAAACgMgAAVgcAAKr4//8BAAAAf39/AAEAAABkAAAAAAAAABQAAABAHwAAAAAAACYAAAAAAAAAwOD//wAAAAAmAAAAZAAAABYAAABMAAAAAAAAAAAAAAAEAAAAAAAAAAEAAABZWVkKAAAAACgAAAAoAAAAZAAAAGQAAAAAAAAAzMzMAAAAAABQAAAAUAAAAGQAAABkAAAAAAAAABcAAAAUAAAAAAAAAAAAAAD/fwAA/38AAAAAAAAJAAAABAAAAAAAAAAeAAAAaAAAAAAAAAAAAAAAAAAAAAAAAAAAAAAAECcAABAnAAAAAAAAAAAAAAAAAAAAAAAAAAAAAAAAAAAAAAAAAAAAABQAAAAAAAAAwMD/AAAAAABkAAAAMgAAAAAAAABkAAAAAAAAAH9/fwAKAAAAIgAAABgAAAAAAAAAAAAAAAAAAAAAAAAAAAAAAAAAAAAkAAAAJAAAAAAAAAAHAAAAAAAAAAAAAAAAAAAAAAAAAAAAAAAAAAAAf39/ACUAAABYAAAAAAAAAAAAAAAAAAAAAAAAAAAAAAAAAAAAAAAAAAAAAAAAAAAAAAAAAAAAAAA/AAAAAAAAAKCGAQAAAAAAAAAAAAAAAAAMAAAAAQAAAAAAAAAAAAAAAAAAAB8AAABUAAAAAAAABQAAAAEAAAAAAAAAAAAAAAAAAAAAAAAAAAAAAAAAAAAAAAAAAAAAAAB/f38AAAAAA8zMzADAwP8Af39/AAAAAAAAAAAAAAAAAAAAAAAAAAAAIQAAABgAAAAUAAAACAcAADgEAAAoIwAAUBkAABAAAAAmAAAACAAAAAEPAAAAAAAA"/>
               </a:ext>
             </a:extLst>
           </p:cNvSpPr>
@@ -1112,7 +1112,7 @@
             <a:spLocks noGrp="1" noChangeArrowheads="1"/>
             <a:extLst>
               <a:ext uri="smNativeData">
-                <pr:smNativeData xmlns:pr="smNativeData" xmlns="smNativeData" val="SMDATA_15_FUV5ZhMAAAAlAAAAZAAAAA0AAAAAkAAAAJAAAACQAAAAkAAAAAAAAAAAAAAAAAAAAAEAAABQAAAAAAAAAAAA4D8AAAAAAADgPwAAAAAAAOA/AAAAAAAA4D8AAAAAAADgPwAAAAAAAOA/AAAAAAAA4D8AAAAAAADgPwAAAAAAAOA/AAAAAAAA4D8CAAAAjAAAAAAAAAAAAAAAQoX0DP///wgAAAAAAAAAAAAAAAAAAAAAAAAAAAAAAAAAAAAAZAAAAAEAAABAAAAAAAAAAAAAAAAAAAAAAAAAAAAAAAAAAAAAAAAAAAAAAAAAAAAAAAAAAAAAAAAAAAAAAAAAAAAAAAAAAAAAAAAAAAAAAAAAAAAAAAAAAAAAAAAAAAAAFAAAADwAAAAAAAAAAAAAAAAAAAkUAAAAAQAAABQAAAAUAAAAFAAAAAEAAAAAAAAAZAAAAGQAAAAAAAAAZAAAAGQAAAAVAAAAYAAAAAAAAAAAAAAADwAAACADAAAAAAAAAAAAAAEAAACgMgAAVgcAAKr4//8BAAAAf39/AAEAAABkAAAAAAAAABQAAABAHwAAAAAAACYAAAAAAAAAwOD//wAAAAAmAAAAZAAAABYAAABMAAAAAAAAAAAAAAAEAAAAAAAAAAEAAABZWVkKAAAAACgAAAAoAAAAZAAAAGQAAAAAAAAAzMzMAAAAAABQAAAAUAAAAGQAAABkAAAAAAAAABcAAAAUAAAAAAAAAAAAAAD/fwAA/38AAAAAAAAJAAAABAAAAF8AYAAeAAAAaAAAAAAAAAAAAAAAAAAAAAAAAAAAAAAAECcAABAnAAAAAAAAAAAAAAAAAAAAAAAAAAAAAAAAAAAAAAAAAAAAABQAAAAAAAAAwMD/AAAAAABkAAAAMgAAAAAAAABkAAAAAAAAAH9/fwAKAAAAIgAAABgAAAAAAAAAAAAAAAAAAAAAAAAAAAAAAAAAAAAkAAAAJAAAAAAAAAAHAAAAAAAAAAAAAAAAAAAAAAAAAAAAAAAAAAAAf39/ACUAAABYAAAAAAAAAAAAAAAAAAAAAAAAAAAAAAAAAAAAAAAAAAAAAAAAAAAAAAAAAAAAAAA/AAAAAAAAAKCGAQAAAAAAAAAAAAAAAAAMAAAAAQAAAAAAAAAAAAAAAAAAAB8AAABUAAAAAAAABQAAAAEAAAAAAAAAAAAAAAAAAAAAAAAAAAAAAAAAAAAAAAAAAAAAAAJ/f38AAAAAA8zMzADAwP8Af39/AAAAAAAAAAAAAAAAAAAAAAAAAAAAIQAAABgAAAAUAAAAOAQAALgaAAD4JQAACDQAABAAAAAmAAAACAAAAL0/AAAAAAAA"/>
+                <pr:smNativeData xmlns:pr="smNativeData" xmlns="smNativeData" val="SMDATA_15_9kV5ZhMAAAAlAAAAZAAAAA0AAAAAkAAAAJAAAACQAAAAkAAAAAAAAAAAAAAAAAAAAAEAAABQAAAAAAAAAAAA4D8AAAAAAADgPwAAAAAAAOA/AAAAAAAA4D8AAAAAAADgPwAAAAAAAOA/AAAAAAAA4D8AAAAAAADgPwAAAAAAAOA/AAAAAAAA4D8CAAAAjAAAAAAAAAAAAAAAQoX0DP///wgAAAAAAAAAAAAAAAAAAAAAAAAAAAAAAAAAAAAAZAAAAAEAAABAAAAAAAAAAAAAAAAAAAAAAAAAAAAAAAAAAAAAAAAAAAAAAAAAAAAAAAAAAAAAAAAAAAAAAAAAAAAAAAAAAAAAAAAAAAAAAAAAAAAAAAAAAAAAAAAAAAAAFAAAADwAAAAAAAAAAAAAAAAAAAkUAAAAAQAAABQAAAAUAAAAFAAAAAEAAAAAAAAAZAAAAGQAAAAAAAAAZAAAAGQAAAAVAAAAYAAAAAAAAAAAAAAADwAAACADAAAAAAAAAAAAAAEAAACgMgAAVgcAAKr4//8BAAAAf39/AAEAAABkAAAAAAAAABQAAABAHwAAAAAAACYAAAAAAAAAwOD//wAAAAAmAAAAZAAAABYAAABMAAAAAAAAAAAAAAAEAAAAAAAAAAEAAABZWVkKAAAAACgAAAAoAAAAZAAAAGQAAAAAAAAAzMzMAAAAAABQAAAAUAAAAGQAAABkAAAAAAAAABcAAAAUAAAAAAAAAAAAAAD/fwAA/38AAAAAAAAJAAAABAAAAF8AYAAeAAAAaAAAAAAAAAAAAAAAAAAAAAAAAAAAAAAAECcAABAnAAAAAAAAAAAAAAAAAAAAAAAAAAAAAAAAAAAAAAAAAAAAABQAAAAAAAAAwMD/AAAAAABkAAAAMgAAAAAAAABkAAAAAAAAAH9/fwAKAAAAIgAAABgAAAAAAAAAAAAAAAAAAAAAAAAAAAAAAAAAAAAkAAAAJAAAAAAAAAAHAAAAAAAAAAAAAAAAAAAAAAAAAAAAAAAAAAAAf39/ACUAAABYAAAAAAAAAAAAAAAAAAAAAAAAAAAAAAAAAAAAAAAAAAAAAAAAAAAAAAAAAAAAAAA/AAAAAAAAAKCGAQAAAAAAAAAAAAAAAAAMAAAAAQAAAAAAAAAAAAAAAAAAAB8AAABUAAAAAAAABQAAAAEAAAAAAAAAAAAAAAAAAAAAAAAAAAAAAAAAAAAAAAAAAAAAAAJ/f38AAAAAA8zMzADAwP8Af39/AAAAAAAAAAAAAAAAAAAAAAAAAAAAIQAAABgAAAAUAAAAOAQAALgaAAD4JQAACDQAABAAAAAmAAAACAAAAL0/AAAAAAAA"/>
               </a:ext>
             </a:extLst>
           </p:cNvSpPr>
@@ -1189,7 +1189,7 @@
             <a:spLocks noGrp="1" noChangeArrowheads="1"/>
             <a:extLst>
               <a:ext uri="smNativeData">
-                <pr:smNativeData xmlns:pr="smNativeData" xmlns="smNativeData" val="SMDATA_15_FUV5ZhMAAAAlAAAACwAAAA0AAAAACAcAADgEAAAoIwAAUBkAAAAAAAAAAAAAAAAAAAEAAABQAAAAAAAAAAAA4D8AAAAAAADgPwAAAAAAAOA/AAAAAAAA4D8AAAAAAADgPwAAAAAAAOA/AAAAAAAA4D8AAAAAAADgPwAAAAAAAOA/AAAAAAAA4D8CAAAAjAAAAAAAAAAAAAAAQoX0DP///wgAAAAAAAAAAAAAAAAAAAAAAAAAAAAAAAAAAAAAZAAAAAEAAABAAAAAAAAAAAAAAAAAAAAAAAAAAAAAAAAAAAAAAAAAAAAAAAAAAAAAAAAAAAAAAAAAAAAAAAAAAAAAAAAAAAAAAAAAAAAAAAAAAAAAAAAAAAAAAAAAAAAAFAAAADwAAAABAAAAAAAAAAAAAAAPAAAAAQAAACMAAAAjAAAAIwAAAB4AAAAAAAAASwAAAEsAAAAAAAAASwAAAEsAAAAVAAAAYAAAAAAAAAAAAAAADwAAACADAAAAAAAAAAAAAAEAAACgMgAAVgcAAKr4//8BAAAAf39/AAEAAABkAAAAAAAAABQAAABAHwAAAAAAACYAAAAAAAAAwOD//wAAAAAmAAAAZAAAABYAAABMAAAAAAAAAAAAAAAEAAAAAAAAAAEAAABZWVkKAAAAACgAAAAoAAAAZAAAAGQAAAAAAAAAzMzMAAAAAABQAAAAUAAAAGQAAABkAAAAAAAAABcAAAAUAAAAAAAAAAAAAAD/fwAA/38AAAAAAAAJAAAABAAAAAAAAAAeAAAAaAAAAAAAAAAAAAAAAAAAAAAAAAAAAAAAECcAABAnAAAAAAAAAAAAAAAAAAAAAAAAAAAAAAAAAAAAAAAAAAAAABQAAAAAAAAAwMD/AAAAAABkAAAAMgAAAAAAAABkAAAAAAAAAH9/fwAKAAAAIgAAABgAAAAAAAAAAAAAAAAAAAAAAAAAAAAAAAAAAAAkAAAAJAAAAAAAAAAHAAAAAAAAAAAAAAAAAAAAAAAAAAAAAAAAAAAAf39/ACUAAABYAAAAAAAAAAAAAAAAAAAAAAAAAAAAAAAAAAAAAAAAAAAAAAAAAAAAAAAAAAAAAAA/AAAAAAAAAKCGAQAAAAAAAAAAAAAAAAAMAAAAAQAAAAAAAAAAAAAAAAAAAB8AAABUAAAAAAAABQAAAAEAAAAAAAAAAAAAAAAAAAAAAAAAAAAAAAAAAAAAAAAAAAAAAAB/f38AAAAAA8zMzADAwP8Af39/AAAAAAAAAAAAAAAAAAAAAAAAAAAAIQAAABgAAAAUAAAACAcAADgEAAAoIwAAUBkAABAAAAAmAAAACAAAAAEPAAAAAAAA"/>
+                <pr:smNativeData xmlns:pr="smNativeData" xmlns="smNativeData" val="SMDATA_15_9kV5ZhMAAAAlAAAACwAAAA0AAAAACAcAADgEAAAoIwAAUBkAAAAAAAAAAAAAAAAAAAEAAABQAAAAAAAAAAAA4D8AAAAAAADgPwAAAAAAAOA/AAAAAAAA4D8AAAAAAADgPwAAAAAAAOA/AAAAAAAA4D8AAAAAAADgPwAAAAAAAOA/AAAAAAAA4D8CAAAAjAAAAAAAAAAAAAAAQoX0DP///wgAAAAAAAAAAAAAAAAAAAAAAAAAAAAAAAAAAAAAZAAAAAEAAABAAAAAAAAAAAAAAAAAAAAAAAAAAAAAAAAAAAAAAAAAAAAAAAAAAAAAAAAAAAAAAAAAAAAAAAAAAAAAAAAAAAAAAAAAAAAAAAAAAAAAAAAAAAAAAAAAAAAAFAAAADwAAAABAAAAAAAAAAAAAAAPAAAAAQAAACMAAAAjAAAAIwAAAB4AAAAAAAAASwAAAEsAAAAAAAAASwAAAEsAAAAVAAAAYAAAAAAAAAAAAAAADwAAACADAAAAAAAAAAAAAAEAAACgMgAAVgcAAKr4//8BAAAAf39/AAEAAABkAAAAAAAAABQAAABAHwAAAAAAACYAAAAAAAAAwOD//wAAAAAmAAAAZAAAABYAAABMAAAAAAAAAAAAAAAEAAAAAAAAAAEAAABZWVkKAAAAACgAAAAoAAAAZAAAAGQAAAAAAAAAzMzMAAAAAABQAAAAUAAAAGQAAABkAAAAAAAAABcAAAAUAAAAAAAAAAAAAAD/fwAA/38AAAAAAAAJAAAABAAAAAAAAAAeAAAAaAAAAAAAAAAAAAAAAAAAAAAAAAAAAAAAECcAABAnAAAAAAAAAAAAAAAAAAAAAAAAAAAAAAAAAAAAAAAAAAAAABQAAAAAAAAAwMD/AAAAAABkAAAAMgAAAAAAAABkAAAAAAAAAH9/fwAKAAAAIgAAABgAAAAAAAAAAAAAAAAAAAAAAAAAAAAAAAAAAAAkAAAAJAAAAAAAAAAHAAAAAAAAAAAAAAAAAAAAAAAAAAAAAAAAAAAAf39/ACUAAABYAAAAAAAAAAAAAAAAAAAAAAAAAAAAAAAAAAAAAAAAAAAAAAAAAAAAAAAAAAAAAAA/AAAAAAAAAKCGAQAAAAAAAAAAAAAAAAAMAAAAAQAAAAAAAAAAAAAAAAAAAB8AAABUAAAAAAAABQAAAAEAAAAAAAAAAAAAAAAAAAAAAAAAAAAAAAAAAAAAAAAAAAAAAAB/f38AAAAAA8zMzADAwP8Af39/AAAAAAAAAAAAAAAAAAAAAAAAAAAAIQAAABgAAAAUAAAACAcAADgEAAAoIwAAUBkAABAAAAAmAAAACAAAAAEPAAAAAAAA"/>
               </a:ext>
             </a:extLst>
           </p:cNvSpPr>
@@ -1235,7 +1235,7 @@
             <a:spLocks noGrp="1" noChangeArrowheads="1"/>
             <a:extLst>
               <a:ext uri="smNativeData">
-                <pr:smNativeData xmlns:pr="smNativeData" xmlns="smNativeData" val="SMDATA_15_FUV5ZhMAAAAlAAAAZAAAAA0AAAAAkAAAAJAAAACQAAAAkAAAAAAAAAAAAAAAAAAAAAEAAABQAAAAAAAAAAAA4D8AAAAAAADgPwAAAAAAAOA/AAAAAAAA4D8AAAAAAADgPwAAAAAAAOA/AAAAAAAA4D8AAAAAAADgPwAAAAAAAOA/AAAAAAAA4D8CAAAAjAAAAAAAAAAAAAAAQoX0DP///wgAAAAAAAAAAAAAAAAAAAAAAAAAAAAAAAAAAAAAZAAAAAEAAABAAAAAAAAAAAAAAAAAAAAAAAAAAAAAAAAAAAAAAAAAAAAAAAAAAAAAAAAAAAAAAAAAAAAAAAAAAAAAAAAAAAAAAAAAAAAAAAAAAAAAAAAAAAAAAAAAAAAAFAAAADwAAAAAAAAAAAAAAAAAAAkUAAAAAQAAABQAAAAUAAAAFAAAAAEAAAAAAAAAZAAAAGQAAAAAAAAAZAAAAGQAAAAVAAAAYAAAAAAAAAAAAAAADwAAACADAAAAAAAAAAAAAAEAAACgMgAAVgcAAKr4//8BAAAAf39/AAEAAABkAAAAAAAAABQAAABAHwAAAAAAACYAAAAAAAAAwOD//wAAAAAmAAAAZAAAABYAAABMAAAAAAAAAAAAAAAEAAAAAAAAAAEAAABZWVkKAAAAACgAAAAoAAAAZAAAAGQAAAAAAAAAzMzMAAAAAABQAAAAUAAAAGQAAABkAAAAAAAAABcAAAAUAAAAAAAAAAAAAAD/fwAA/38AAAAAAAAJAAAABAAAAM/Y+1ceAAAAaAAAAAAAAAAAAAAAAAAAAAAAAAAAAAAAECcAABAnAAAAAAAAAAAAAAAAAAAAAAAAAAAAAAAAAAAAAAAAAAAAABQAAAAAAAAAwMD/AAAAAABkAAAAMgAAAAAAAABkAAAAAAAAAH9/fwAKAAAAIgAAABgAAAAAAAAAAAAAAAAAAAAAAAAAAAAAAAAAAAAkAAAAJAAAAAAAAAAHAAAAAAAAAAAAAAAAAAAAAAAAAAAAAAAAAAAAf39/ACUAAABYAAAAAAAAAAAAAAAAAAAAAAAAAAAAAAAAAAAAAAAAAAAAAAAAAAAAAAAAAAAAAAA/AAAAAAAAAKCGAQAAAAAAAAAAAAAAAAAMAAAAAQAAAAAAAAAAAAAAAAAAAB8AAABUAAAAAAAABQAAAAEAAAAAAAAAAAAAAAAAAAAAAAAAAAAAAAAAAAAAAAAAAAAAAAJ/f38AAAAAA8zMzADAwP8Af39/AAAAAAAAAAAAAAAAAAAAAAAAAAAAIQAAABgAAAAUAAAAOAQAALgaAAD4JQAACDQAABAAAAAmAAAACAAAAL0/AAAAAAAA"/>
+                <pr:smNativeData xmlns:pr="smNativeData" xmlns="smNativeData" val="SMDATA_15_9kV5ZhMAAAAlAAAAZAAAAA0AAAAAkAAAAJAAAACQAAAAkAAAAAAAAAAAAAAAAAAAAAEAAABQAAAAAAAAAAAA4D8AAAAAAADgPwAAAAAAAOA/AAAAAAAA4D8AAAAAAADgPwAAAAAAAOA/AAAAAAAA4D8AAAAAAADgPwAAAAAAAOA/AAAAAAAA4D8CAAAAjAAAAAAAAAAAAAAAQoX0DP///wgAAAAAAAAAAAAAAAAAAAAAAAAAAAAAAAAAAAAAZAAAAAEAAABAAAAAAAAAAAAAAAAAAAAAAAAAAAAAAAAAAAAAAAAAAAAAAAAAAAAAAAAAAAAAAAAAAAAAAAAAAAAAAAAAAAAAAAAAAAAAAAAAAAAAAAAAAAAAAAAAAAAAFAAAADwAAAAAAAAAAAAAAAAAAAkUAAAAAQAAABQAAAAUAAAAFAAAAAEAAAAAAAAAZAAAAGQAAAAAAAAAZAAAAGQAAAAVAAAAYAAAAAAAAAAAAAAADwAAACADAAAAAAAAAAAAAAEAAACgMgAAVgcAAKr4//8BAAAAf39/AAEAAABkAAAAAAAAABQAAABAHwAAAAAAACYAAAAAAAAAwOD//wAAAAAmAAAAZAAAABYAAABMAAAAAAAAAAAAAAAEAAAAAAAAAAEAAABZWVkKAAAAACgAAAAoAAAAZAAAAGQAAAAAAAAAzMzMAAAAAABQAAAAUAAAAGQAAABkAAAAAAAAABcAAAAUAAAAAAAAAAAAAAD/fwAA/38AAAAAAAAJAAAABAAAAM/Y+1ceAAAAaAAAAAAAAAAAAAAAAAAAAAAAAAAAAAAAECcAABAnAAAAAAAAAAAAAAAAAAAAAAAAAAAAAAAAAAAAAAAAAAAAABQAAAAAAAAAwMD/AAAAAABkAAAAMgAAAAAAAABkAAAAAAAAAH9/fwAKAAAAIgAAABgAAAAAAAAAAAAAAAAAAAAAAAAAAAAAAAAAAAAkAAAAJAAAAAAAAAAHAAAAAAAAAAAAAAAAAAAAAAAAAAAAAAAAAAAAf39/ACUAAABYAAAAAAAAAAAAAAAAAAAAAAAAAAAAAAAAAAAAAAAAAAAAAAAAAAAAAAAAAAAAAAA/AAAAAAAAAKCGAQAAAAAAAAAAAAAAAAAMAAAAAQAAAAAAAAAAAAAAAAAAAB8AAABUAAAAAAAABQAAAAEAAAAAAAAAAAAAAAAAAAAAAAAAAAAAAAAAAAAAAAAAAAAAAAJ/f38AAAAAA8zMzADAwP8Af39/AAAAAAAAAAAAAAAAAAAAAAAAAAAAIQAAABgAAAAUAAAAOAQAALgaAAD4JQAACDQAABAAAAAmAAAACAAAAL0/AAAAAAAA"/>
               </a:ext>
             </a:extLst>
           </p:cNvSpPr>
@@ -1312,7 +1312,7 @@
             <a:spLocks noGrp="1" noChangeArrowheads="1"/>
             <a:extLst>
               <a:ext uri="smNativeData">
-                <pr:smNativeData xmlns:pr="smNativeData" xmlns="smNativeData" val="SMDATA_15_FUV5ZhMAAAAlAAAACwAAAA0AAAAACAcAADgEAAAoIwAAUBkAAAAAAAAAAAAAAAAAAAEAAABQAAAAAAAAAAAA4D8AAAAAAADgPwAAAAAAAOA/AAAAAAAA4D8AAAAAAADgPwAAAAAAAOA/AAAAAAAA4D8AAAAAAADgPwAAAAAAAOA/AAAAAAAA4D8CAAAAjAAAAAAAAAAAAAAAQoX0DP///wgAAAAAAAAAAAAAAAAAAAAAAAAAAAAAAAAAAAAAZAAAAAEAAABAAAAAAAAAAAAAAAAAAAAAAAAAAAAAAAAAAAAAAAAAAAAAAAAAAAAAAAAAAAAAAAAAAAAAAAAAAAAAAAAAAAAAAAAAAAAAAAAAAAAAAAAAAAAAAAAAAAAAFAAAADwAAAABAAAAAAAAAAAAAAAPAAAAAQAAACMAAAAjAAAAIwAAAB4AAAAAAAAASwAAAEsAAAAAAAAASwAAAEsAAAAVAAAAYAAAAAAAAAAAAAAADwAAACADAAAAAAAAAAAAAAEAAACgMgAAVgcAAKr4//8BAAAAf39/AAEAAABkAAAAAAAAABQAAABAHwAAAAAAACYAAAAAAAAAwOD//wAAAAAmAAAAZAAAABYAAABMAAAAAAAAAAAAAAAEAAAAAAAAAAEAAABZWVkKAAAAACgAAAAoAAAAZAAAAGQAAAAAAAAAzMzMAAAAAABQAAAAUAAAAGQAAABkAAAAAAAAABcAAAAUAAAAAAAAAAAAAAD/fwAA/38AAAAAAAAJAAAABAAAAEXJ0L8eAAAAaAAAAAAAAAAAAAAAAAAAAAAAAAAAAAAAECcAABAnAAAAAAAAAAAAAAAAAAAAAAAAAAAAAAAAAAAAAAAAAAAAABQAAAAAAAAAwMD/AAAAAABkAAAAMgAAAAAAAABkAAAAAAAAAH9/fwAKAAAAIgAAABgAAAAAAAAAAAAAAAAAAAAAAAAAAAAAAAAAAAAkAAAAJAAAAAAAAAAHAAAAAAAAAAAAAAAAAAAAAAAAAAAAAAAAAAAAf39/ACUAAABYAAAAAAAAAAAAAAAAAAAAAAAAAAAAAAAAAAAAAAAAAAAAAAAAAAAAAAAAAAAAAAA/AAAAAAAAAKCGAQAAAAAAAAAAAAAAAAAMAAAAAQAAAAAAAAAAAAAAAAAAAB8AAABUAAAAAAAABQAAAAEAAAAAAAAAAAAAAAAAAAAAAAAAAAAAAAAAAAAAAAAAAAAAAAB/f38AAAAAA8zMzADAwP8Af39/AAAAAAAAAAAAAAAAAAAAAAAAAAAAIQAAABgAAAAUAAAACAcAADgEAAAoIwAAUBkAABAAAAAmAAAACAAAAAEPAAAAAAAA"/>
+                <pr:smNativeData xmlns:pr="smNativeData" xmlns="smNativeData" val="SMDATA_15_9kV5ZhMAAAAlAAAACwAAAA0AAAAACAcAADgEAAAoIwAAUBkAAAAAAAAAAAAAAAAAAAEAAABQAAAAAAAAAAAA4D8AAAAAAADgPwAAAAAAAOA/AAAAAAAA4D8AAAAAAADgPwAAAAAAAOA/AAAAAAAA4D8AAAAAAADgPwAAAAAAAOA/AAAAAAAA4D8CAAAAjAAAAAAAAAAAAAAAQoX0DP///wgAAAAAAAAAAAAAAAAAAAAAAAAAAAAAAAAAAAAAZAAAAAEAAABAAAAAAAAAAAAAAAAAAAAAAAAAAAAAAAAAAAAAAAAAAAAAAAAAAAAAAAAAAAAAAAAAAAAAAAAAAAAAAAAAAAAAAAAAAAAAAAAAAAAAAAAAAAAAAAAAAAAAFAAAADwAAAABAAAAAAAAAAAAAAAPAAAAAQAAACMAAAAjAAAAIwAAAB4AAAAAAAAASwAAAEsAAAAAAAAASwAAAEsAAAAVAAAAYAAAAAAAAAAAAAAADwAAACADAAAAAAAAAAAAAAEAAACgMgAAVgcAAKr4//8BAAAAf39/AAEAAABkAAAAAAAAABQAAABAHwAAAAAAACYAAAAAAAAAwOD//wAAAAAmAAAAZAAAABYAAABMAAAAAAAAAAAAAAAEAAAAAAAAAAEAAABZWVkKAAAAACgAAAAoAAAAZAAAAGQAAAAAAAAAzMzMAAAAAABQAAAAUAAAAGQAAABkAAAAAAAAABcAAAAUAAAAAAAAAAAAAAD/fwAA/38AAAAAAAAJAAAABAAAAEXJ0L8eAAAAaAAAAAAAAAAAAAAAAAAAAAAAAAAAAAAAECcAABAnAAAAAAAAAAAAAAAAAAAAAAAAAAAAAAAAAAAAAAAAAAAAABQAAAAAAAAAwMD/AAAAAABkAAAAMgAAAAAAAABkAAAAAAAAAH9/fwAKAAAAIgAAABgAAAAAAAAAAAAAAAAAAAAAAAAAAAAAAAAAAAAkAAAAJAAAAAAAAAAHAAAAAAAAAAAAAAAAAAAAAAAAAAAAAAAAAAAAf39/ACUAAABYAAAAAAAAAAAAAAAAAAAAAAAAAAAAAAAAAAAAAAAAAAAAAAAAAAAAAAAAAAAAAAA/AAAAAAAAAKCGAQAAAAAAAAAAAAAAAAAMAAAAAQAAAAAAAAAAAAAAAAAAAB8AAABUAAAAAAAABQAAAAEAAAAAAAAAAAAAAAAAAAAAAAAAAAAAAAAAAAAAAAAAAAAAAAB/f38AAAAAA8zMzADAwP8Af39/AAAAAAAAAAAAAAAAAAAAAAAAAAAAIQAAABgAAAAUAAAACAcAADgEAAAoIwAAUBkAABAAAAAmAAAACAAAAAEPAAAAAAAA"/>
               </a:ext>
             </a:extLst>
           </p:cNvSpPr>
@@ -1358,7 +1358,7 @@
             <a:spLocks noGrp="1" noChangeArrowheads="1"/>
             <a:extLst>
               <a:ext uri="smNativeData">
-                <pr:smNativeData xmlns:pr="smNativeData" xmlns="smNativeData" val="SMDATA_15_FUV5ZhMAAAAlAAAAZAAAAA0AAAAAkAAAAJAAAACQAAAAkAAAAAAAAAAAAAAAAAAAAAEAAABQAAAAAAAAAAAA4D8AAAAAAADgPwAAAAAAAOA/AAAAAAAA4D8AAAAAAADgPwAAAAAAAOA/AAAAAAAA4D8AAAAAAADgPwAAAAAAAOA/AAAAAAAA4D8CAAAAjAAAAAAAAAAAAAAAQoX0DP///wgAAAAAAAAAAAAAAAAAAAAAAAAAAAAAAAAAAAAAZAAAAAEAAABAAAAAAAAAAAAAAAAAAAAAAAAAAAAAAAAAAAAAAAAAAAAAAAAAAAAAAAAAAAAAAAAAAAAAAAAAAAAAAAAAAAAAAAAAAAAAAAAAAAAAAAAAAAAAAAAAAAAAFAAAADwAAAAAAAAAAAAAAAAAAAkUAAAAAQAAABQAAAAUAAAAFAAAAAEAAAAAAAAAZAAAAGQAAAAAAAAAZAAAAGQAAAAVAAAAYAAAAAAAAAAAAAAADwAAACADAAAAAAAAAAAAAAEAAACgMgAAVgcAAKr4//8BAAAAf39/AAEAAABkAAAAAAAAABQAAABAHwAAAAAAACYAAAAAAAAAwOD//wAAAAAmAAAAZAAAABYAAABMAAAAAAAAAAAAAAAEAAAAAAAAAAEAAABZWVkKAAAAACgAAAAoAAAAZAAAAGQAAAAAAAAAzMzMAAAAAABQAAAAUAAAAGQAAABkAAAAAAAAABcAAAAUAAAAAAAAAAAAAAD/fwAA/38AAAAAAAAJAAAABAAAAF8AYAAeAAAAaAAAAAAAAAAAAAAAAAAAAAAAAAAAAAAAECcAABAnAAAAAAAAAAAAAAAAAAAAAAAAAAAAAAAAAAAAAAAAAAAAABQAAAAAAAAAwMD/AAAAAABkAAAAMgAAAAAAAABkAAAAAAAAAH9/fwAKAAAAIgAAABgAAAAAAAAAAAAAAAAAAAAAAAAAAAAAAAAAAAAkAAAAJAAAAAAAAAAHAAAAAAAAAAAAAAAAAAAAAAAAAAAAAAAAAAAAf39/ACUAAABYAAAAAAAAAAAAAAAAAAAAAAAAAAAAAAAAAAAAAAAAAAAAAAAAAAAAAAAAAAAAAAA/AAAAAAAAAKCGAQAAAAAAAAAAAAAAAAAMAAAAAQAAAAAAAAAAAAAAAAAAAB8AAABUAAAAAAAABQAAAAEAAAAAAAAAAAAAAAAAAAAAAAAAAAAAAAAAAAAAAAAAAAAAAAJ/f38AAAAAA8zMzADAwP8Af39/AAAAAAAAAAAAAAAAAAAAAAAAAAAAIQAAABgAAAAUAAAAOAQAALgaAAD4JQAACDQAABAAAAAmAAAACAAAAL0/AAAAAAAA"/>
+                <pr:smNativeData xmlns:pr="smNativeData" xmlns="smNativeData" val="SMDATA_15_9kV5ZhMAAAAlAAAAZAAAAA0AAAAAkAAAAJAAAACQAAAAkAAAAAAAAAAAAAAAAAAAAAEAAABQAAAAAAAAAAAA4D8AAAAAAADgPwAAAAAAAOA/AAAAAAAA4D8AAAAAAADgPwAAAAAAAOA/AAAAAAAA4D8AAAAAAADgPwAAAAAAAOA/AAAAAAAA4D8CAAAAjAAAAAAAAAAAAAAAQoX0DP///wgAAAAAAAAAAAAAAAAAAAAAAAAAAAAAAAAAAAAAZAAAAAEAAABAAAAAAAAAAAAAAAAAAAAAAAAAAAAAAAAAAAAAAAAAAAAAAAAAAAAAAAAAAAAAAAAAAAAAAAAAAAAAAAAAAAAAAAAAAAAAAAAAAAAAAAAAAAAAAAAAAAAAFAAAADwAAAAAAAAAAAAAAAAAAAkUAAAAAQAAABQAAAAUAAAAFAAAAAEAAAAAAAAAZAAAAGQAAAAAAAAAZAAAAGQAAAAVAAAAYAAAAAAAAAAAAAAADwAAACADAAAAAAAAAAAAAAEAAACgMgAAVgcAAKr4//8BAAAAf39/AAEAAABkAAAAAAAAABQAAABAHwAAAAAAACYAAAAAAAAAwOD//wAAAAAmAAAAZAAAABYAAABMAAAAAAAAAAAAAAAEAAAAAAAAAAEAAABZWVkKAAAAACgAAAAoAAAAZAAAAGQAAAAAAAAAzMzMAAAAAABQAAAAUAAAAGQAAABkAAAAAAAAABcAAAAUAAAAAAAAAAAAAAD/fwAA/38AAAAAAAAJAAAABAAAAF8AYAAeAAAAaAAAAAAAAAAAAAAAAAAAAAAAAAAAAAAAECcAABAnAAAAAAAAAAAAAAAAAAAAAAAAAAAAAAAAAAAAAAAAAAAAABQAAAAAAAAAwMD/AAAAAABkAAAAMgAAAAAAAABkAAAAAAAAAH9/fwAKAAAAIgAAABgAAAAAAAAAAAAAAAAAAAAAAAAAAAAAAAAAAAAkAAAAJAAAAAAAAAAHAAAAAAAAAAAAAAAAAAAAAAAAAAAAAAAAAAAAf39/ACUAAABYAAAAAAAAAAAAAAAAAAAAAAAAAAAAAAAAAAAAAAAAAAAAAAAAAAAAAAAAAAAAAAA/AAAAAAAAAKCGAQAAAAAAAAAAAAAAAAAMAAAAAQAAAAAAAAAAAAAAAAAAAB8AAABUAAAAAAAABQAAAAEAAAAAAAAAAAAAAAAAAAAAAAAAAAAAAAAAAAAAAAAAAAAAAAJ/f38AAAAAA8zMzADAwP8Af39/AAAAAAAAAAAAAAAAAAAAAAAAAAAAIQAAABgAAAAUAAAAOAQAALgaAAD4JQAACDQAABAAAAAmAAAACAAAAL0/AAAAAAAA"/>
               </a:ext>
             </a:extLst>
           </p:cNvSpPr>
@@ -1435,7 +1435,7 @@
             <a:spLocks noGrp="1" noChangeArrowheads="1"/>
             <a:extLst>
               <a:ext uri="smNativeData">
-                <pr:smNativeData xmlns:pr="smNativeData" xmlns="smNativeData" val="SMDATA_15_FUV5ZhMAAAAlAAAACwAAAA0AAAAACAcAADgEAAAoIwAAUBkAAAAAAAAAAAAAAAAAAAEAAABQAAAAAAAAAAAA4D8AAAAAAADgPwAAAAAAAOA/AAAAAAAA4D8AAAAAAADgPwAAAAAAAOA/AAAAAAAA4D8AAAAAAADgPwAAAAAAAOA/AAAAAAAA4D8CAAAAjAAAAAAAAAAAAAAAQoX0DP///wgAAAAAAAAAAAAAAAAAAAAAAAAAAAAAAAAAAAAAZAAAAAEAAABAAAAAAAAAAAAAAAAAAAAAAAAAAAAAAAAAAAAAAAAAAAAAAAAAAAAAAAAAAAAAAAAAAAAAAAAAAAAAAAAAAAAAAAAAAAAAAAAAAAAAAAAAAAAAAAAAAAAAFAAAADwAAAABAAAAAAAAAAAAAAAPAAAAAQAAACMAAAAjAAAAIwAAAB4AAAAAAAAASwAAAEsAAAAAAAAASwAAAEsAAAAVAAAAYAAAAAAAAAAAAAAADwAAACADAAAAAAAAAAAAAAEAAACgMgAAVgcAAKr4//8BAAAAf39/AAEAAABkAAAAAAAAABQAAABAHwAAAAAAACYAAAAAAAAAwOD//wAAAAAmAAAAZAAAABYAAABMAAAAAAAAAAAAAAAEAAAAAAAAAAEAAABZWVkKAAAAACgAAAAoAAAAZAAAAGQAAAAAAAAAzMzMAAAAAABQAAAAUAAAAGQAAABkAAAAAAAAABcAAAAUAAAAAAAAAAAAAAD/fwAA/38AAAAAAAAJAAAABAAAAAAAAAAeAAAAaAAAAAAAAAAAAAAAAAAAAAAAAAAAAAAAECcAABAnAAAAAAAAAAAAAAAAAAAAAAAAAAAAAAAAAAAAAAAAAAAAABQAAAAAAAAAwMD/AAAAAABkAAAAMgAAAAAAAABkAAAAAAAAAH9/fwAKAAAAIgAAABgAAAAAAAAAAAAAAAAAAAAAAAAAAAAAAAAAAAAkAAAAJAAAAAAAAAAHAAAAAAAAAAAAAAAAAAAAAAAAAAAAAAAAAAAAf39/ACUAAABYAAAAAAAAAAAAAAAAAAAAAAAAAAAAAAAAAAAAAAAAAAAAAAAAAAAAAAAAAAAAAAA/AAAAAAAAAKCGAQAAAAAAAAAAAAAAAAAMAAAAAQAAAAAAAAAAAAAAAAAAAB8AAABUAAAAAAAABQAAAAEAAAAAAAAAAAAAAAAAAAAAAAAAAAAAAAAAAAAAAAAAAAAAAAB/f38AAAAAA8zMzADAwP8Af39/AAAAAAAAAAAAAAAAAAAAAAAAAAAAIQAAABgAAAAUAAAACAcAADgEAAAoIwAAUBkAABAAAAAmAAAACAAAAAEPAAAAAAAA"/>
+                <pr:smNativeData xmlns:pr="smNativeData" xmlns="smNativeData" val="SMDATA_15_9kV5ZhMAAAAlAAAACwAAAA0AAAAACAcAADgEAAAoIwAAUBkAAAAAAAAAAAAAAAAAAAEAAABQAAAAAAAAAAAA4D8AAAAAAADgPwAAAAAAAOA/AAAAAAAA4D8AAAAAAADgPwAAAAAAAOA/AAAAAAAA4D8AAAAAAADgPwAAAAAAAOA/AAAAAAAA4D8CAAAAjAAAAAAAAAAAAAAAQoX0DP///wgAAAAAAAAAAAAAAAAAAAAAAAAAAAAAAAAAAAAAZAAAAAEAAABAAAAAAAAAAAAAAAAAAAAAAAAAAAAAAAAAAAAAAAAAAAAAAAAAAAAAAAAAAAAAAAAAAAAAAAAAAAAAAAAAAAAAAAAAAAAAAAAAAAAAAAAAAAAAAAAAAAAAFAAAADwAAAABAAAAAAAAAAAAAAAPAAAAAQAAACMAAAAjAAAAIwAAAB4AAAAAAAAASwAAAEsAAAAAAAAASwAAAEsAAAAVAAAAYAAAAAAAAAAAAAAADwAAACADAAAAAAAAAAAAAAEAAACgMgAAVgcAAKr4//8BAAAAf39/AAEAAABkAAAAAAAAABQAAABAHwAAAAAAACYAAAAAAAAAwOD//wAAAAAmAAAAZAAAABYAAABMAAAAAAAAAAAAAAAEAAAAAAAAAAEAAABZWVkKAAAAACgAAAAoAAAAZAAAAGQAAAAAAAAAzMzMAAAAAABQAAAAUAAAAGQAAABkAAAAAAAAABcAAAAUAAAAAAAAAAAAAAD/fwAA/38AAAAAAAAJAAAABAAAAAAAAAAeAAAAaAAAAAAAAAAAAAAAAAAAAAAAAAAAAAAAECcAABAnAAAAAAAAAAAAAAAAAAAAAAAAAAAAAAAAAAAAAAAAAAAAABQAAAAAAAAAwMD/AAAAAABkAAAAMgAAAAAAAABkAAAAAAAAAH9/fwAKAAAAIgAAABgAAAAAAAAAAAAAAAAAAAAAAAAAAAAAAAAAAAAkAAAAJAAAAAAAAAAHAAAAAAAAAAAAAAAAAAAAAAAAAAAAAAAAAAAAf39/ACUAAABYAAAAAAAAAAAAAAAAAAAAAAAAAAAAAAAAAAAAAAAAAAAAAAAAAAAAAAAAAAAAAAA/AAAAAAAAAKCGAQAAAAAAAAAAAAAAAAAMAAAAAQAAAAAAAAAAAAAAAAAAAB8AAABUAAAAAAAABQAAAAEAAAAAAAAAAAAAAAAAAAAAAAAAAAAAAAAAAAAAAAAAAAAAAAB/f38AAAAAA8zMzADAwP8Af39/AAAAAAAAAAAAAAAAAAAAAAAAAAAAIQAAABgAAAAUAAAACAcAADgEAAAoIwAAUBkAABAAAAAmAAAACAAAAAEPAAAAAAAA"/>
               </a:ext>
             </a:extLst>
           </p:cNvSpPr>
@@ -1481,7 +1481,7 @@
             <a:spLocks noGrp="1" noChangeArrowheads="1"/>
             <a:extLst>
               <a:ext uri="smNativeData">
-                <pr:smNativeData xmlns:pr="smNativeData" xmlns="smNativeData" val="SMDATA_15_FUV5ZhMAAAAlAAAAZAAAAA0AAAAAkAAAAJAAAACQAAAAkAAAAAAAAAAAAAAAAAAAAAEAAABQAAAAAAAAAAAA4D8AAAAAAADgPwAAAAAAAOA/AAAAAAAA4D8AAAAAAADgPwAAAAAAAOA/AAAAAAAA4D8AAAAAAADgPwAAAAAAAOA/AAAAAAAA4D8CAAAAjAAAAAAAAAAAAAAAQoX0DP///wgAAAAAAAAAAAAAAAAAAAAAAAAAAAAAAAAAAAAAZAAAAAEAAABAAAAAAAAAAAAAAAAAAAAAAAAAAAAAAAAAAAAAAAAAAAAAAAAAAAAAAAAAAAAAAAAAAAAAAAAAAAAAAAAAAAAAAAAAAAAAAAAAAAAAAAAAAAAAAAAAAAAAFAAAADwAAAAAAAAAAAAAAAAAAAkUAAAAAQAAABQAAAAUAAAAFAAAAAEAAAAAAAAAZAAAAGQAAAAAAAAAZAAAAGQAAAAVAAAAYAAAAAAAAAAAAAAADwAAACADAAAAAAAAAAAAAAEAAACgMgAAVgcAAKr4//8BAAAAf39/AAEAAABkAAAAAAAAABQAAABAHwAAAAAAACYAAAAAAAAAwOD//wAAAAAmAAAAZAAAABYAAABMAAAAAAAAAAAAAAAEAAAAAAAAAAEAAABZWVkKAAAAACgAAAAoAAAAZAAAAGQAAAAAAAAAzMzMAAAAAABQAAAAUAAAAGQAAABkAAAAAAAAABcAAAAUAAAAAAAAAAAAAAD/fwAA/38AAAAAAAAJAAAABAAAADFRIqYeAAAAaAAAAAAAAAAAAAAAAAAAAAAAAAAAAAAAECcAABAnAAAAAAAAAAAAAAAAAAAAAAAAAAAAAAAAAAAAAAAAAAAAABQAAAAAAAAAwMD/AAAAAABkAAAAMgAAAAAAAABkAAAAAAAAAH9/fwAKAAAAIgAAABgAAAAAAAAAAAAAAAAAAAAAAAAAAAAAAAAAAAAkAAAAJAAAAAAAAAAHAAAAAAAAAAAAAAAAAAAAAAAAAAAAAAAAAAAAf39/ACUAAABYAAAAAAAAAAAAAAAAAAAAAAAAAAAAAAAAAAAAAAAAAAAAAAAAAAAAAAAAAAAAAAA/AAAAAAAAAKCGAQAAAAAAAAAAAAAAAAAMAAAAAQAAAAAAAAAAAAAAAAAAAB8AAABUAAAAAAAABQAAAAEAAAAAAAAAAAAAAAAAAAAAAAAAAAAAAAAAAAAAAAAAAAAAAAJ/f38AAAAAA8zMzADAwP8Af39/AAAAAAAAAAAAAAAAAAAAAAAAAAAAIQAAABgAAAAUAAAAOAQAALgaAAD4JQAACDQAABAAAAAmAAAACAAAAL0/AAAAAAAA"/>
+                <pr:smNativeData xmlns:pr="smNativeData" xmlns="smNativeData" val="SMDATA_15_9kV5ZhMAAAAlAAAAZAAAAA0AAAAAkAAAAJAAAACQAAAAkAAAAAAAAAAAAAAAAAAAAAEAAABQAAAAAAAAAAAA4D8AAAAAAADgPwAAAAAAAOA/AAAAAAAA4D8AAAAAAADgPwAAAAAAAOA/AAAAAAAA4D8AAAAAAADgPwAAAAAAAOA/AAAAAAAA4D8CAAAAjAAAAAAAAAAAAAAAQoX0DP///wgAAAAAAAAAAAAAAAAAAAAAAAAAAAAAAAAAAAAAZAAAAAEAAABAAAAAAAAAAAAAAAAAAAAAAAAAAAAAAAAAAAAAAAAAAAAAAAAAAAAAAAAAAAAAAAAAAAAAAAAAAAAAAAAAAAAAAAAAAAAAAAAAAAAAAAAAAAAAAAAAAAAAFAAAADwAAAAAAAAAAAAAAAAAAAkUAAAAAQAAABQAAAAUAAAAFAAAAAEAAAAAAAAAZAAAAGQAAAAAAAAAZAAAAGQAAAAVAAAAYAAAAAAAAAAAAAAADwAAACADAAAAAAAAAAAAAAEAAACgMgAAVgcAAKr4//8BAAAAf39/AAEAAABkAAAAAAAAABQAAABAHwAAAAAAACYAAAAAAAAAwOD//wAAAAAmAAAAZAAAABYAAABMAAAAAAAAAAAAAAAEAAAAAAAAAAEAAABZWVkKAAAAACgAAAAoAAAAZAAAAGQAAAAAAAAAzMzMAAAAAABQAAAAUAAAAGQAAABkAAAAAAAAABcAAAAUAAAAAAAAAAAAAAD/fwAA/38AAAAAAAAJAAAABAAAADFRIqYeAAAAaAAAAAAAAAAAAAAAAAAAAAAAAAAAAAAAECcAABAnAAAAAAAAAAAAAAAAAAAAAAAAAAAAAAAAAAAAAAAAAAAAABQAAAAAAAAAwMD/AAAAAABkAAAAMgAAAAAAAABkAAAAAAAAAH9/fwAKAAAAIgAAABgAAAAAAAAAAAAAAAAAAAAAAAAAAAAAAAAAAAAkAAAAJAAAAAAAAAAHAAAAAAAAAAAAAAAAAAAAAAAAAAAAAAAAAAAAf39/ACUAAABYAAAAAAAAAAAAAAAAAAAAAAAAAAAAAAAAAAAAAAAAAAAAAAAAAAAAAAAAAAAAAAA/AAAAAAAAAKCGAQAAAAAAAAAAAAAAAAAMAAAAAQAAAAAAAAAAAAAAAAAAAB8AAABUAAAAAAAABQAAAAEAAAAAAAAAAAAAAAAAAAAAAAAAAAAAAAAAAAAAAAAAAAAAAAJ/f38AAAAAA8zMzADAwP8Af39/AAAAAAAAAAAAAAAAAAAAAAAAAAAAIQAAABgAAAAUAAAAOAQAALgaAAD4JQAACDQAABAAAAAmAAAACAAAAL0/AAAAAAAA"/>
               </a:ext>
             </a:extLst>
           </p:cNvSpPr>
@@ -1558,7 +1558,7 @@
             <a:spLocks noGrp="1" noChangeArrowheads="1"/>
             <a:extLst>
               <a:ext uri="smNativeData">
-                <pr:smNativeData xmlns:pr="smNativeData" xmlns="smNativeData" val="SMDATA_15_FUV5ZhMAAAAlAAAACwAAAA0AAAAACAcAADgEAAAoIwAAUBkAAAAAAAAAAAAAAAAAAAEAAABQAAAAAAAAAAAA4D8AAAAAAADgPwAAAAAAAOA/AAAAAAAA4D8AAAAAAADgPwAAAAAAAOA/AAAAAAAA4D8AAAAAAADgPwAAAAAAAOA/AAAAAAAA4D8CAAAAjAAAAAAAAAAAAAAAQoX0DP///wgAAAAAAAAAAAAAAAAAAAAAAAAAAAAAAAAAAAAAZAAAAAEAAABAAAAAAAAAAAAAAAAAAAAAAAAAAAAAAAAAAAAAAAAAAAAAAAAAAAAAAAAAAAAAAAAAAAAAAAAAAAAAAAAAAAAAAAAAAAAAAAAAAAAAAAAAAAAAAAAAAAAAFAAAADwAAAABAAAAAAAAAAAAAAAPAAAAAQAAACMAAAAjAAAAIwAAAB4AAAAAAAAASwAAAEsAAAAAAAAASwAAAEsAAAAVAAAAYAAAAAAAAAAAAAAADwAAACADAAAAAAAAAAAAAAEAAACgMgAAVgcAAKr4//8BAAAAf39/AAEAAABkAAAAAAAAABQAAABAHwAAAAAAACYAAAAAAAAAwOD//wAAAAAmAAAAZAAAABYAAABMAAAAAAAAAAAAAAAEAAAAAAAAAAEAAABZWVkKAAAAACgAAAAoAAAAZAAAAGQAAAAAAAAAzMzMAAAAAABQAAAAUAAAAGQAAABkAAAAAAAAABcAAAAUAAAAAAAAAAAAAAD/fwAA/38AAAAAAAAJAAAABAAAAAAAAAAeAAAAaAAAAAAAAAAAAAAAAAAAAAAAAAAAAAAAECcAABAnAAAAAAAAAAAAAAAAAAAAAAAAAAAAAAAAAAAAAAAAAAAAABQAAAAAAAAAwMD/AAAAAABkAAAAMgAAAAAAAABkAAAAAAAAAH9/fwAKAAAAIgAAABgAAAAAAAAAAAAAAAAAAAAAAAAAAAAAAAAAAAAkAAAAJAAAAAAAAAAHAAAAAAAAAAAAAAAAAAAAAAAAAAAAAAAAAAAAf39/ACUAAABYAAAAAAAAAAAAAAAAAAAAAAAAAAAAAAAAAAAAAAAAAAAAAAAAAAAAAAAAAAAAAAA/AAAAAAAAAKCGAQAAAAAAAAAAAAAAAAAMAAAAAQAAAAAAAAAAAAAAAAAAAB8AAABUAAAAAAAABQAAAAEAAAAAAAAAAAAAAAAAAAAAAAAAAAAAAAAAAAAAAAAAAAAAAAB/f38AAAAAA8zMzADAwP8Af39/AAAAAAAAAAAAAAAAAAAAAAAAAAAAIQAAABgAAAAUAAAACAcAADgEAAAoIwAAUBkAABAAAAAmAAAACAAAAAEPAAAAAAAA"/>
+                <pr:smNativeData xmlns:pr="smNativeData" xmlns="smNativeData" val="SMDATA_15_9kV5ZhMAAAAlAAAACwAAAA0AAAAACAcAADgEAAAoIwAAUBkAAAAAAAAAAAAAAAAAAAEAAABQAAAAAAAAAAAA4D8AAAAAAADgPwAAAAAAAOA/AAAAAAAA4D8AAAAAAADgPwAAAAAAAOA/AAAAAAAA4D8AAAAAAADgPwAAAAAAAOA/AAAAAAAA4D8CAAAAjAAAAAAAAAAAAAAAQoX0DP///wgAAAAAAAAAAAAAAAAAAAAAAAAAAAAAAAAAAAAAZAAAAAEAAABAAAAAAAAAAAAAAAAAAAAAAAAAAAAAAAAAAAAAAAAAAAAAAAAAAAAAAAAAAAAAAAAAAAAAAAAAAAAAAAAAAAAAAAAAAAAAAAAAAAAAAAAAAAAAAAAAAAAAFAAAADwAAAABAAAAAAAAAAAAAAAPAAAAAQAAACMAAAAjAAAAIwAAAB4AAAAAAAAASwAAAEsAAAAAAAAASwAAAEsAAAAVAAAAYAAAAAAAAAAAAAAADwAAACADAAAAAAAAAAAAAAEAAACgMgAAVgcAAKr4//8BAAAAf39/AAEAAABkAAAAAAAAABQAAABAHwAAAAAAACYAAAAAAAAAwOD//wAAAAAmAAAAZAAAABYAAABMAAAAAAAAAAAAAAAEAAAAAAAAAAEAAABZWVkKAAAAACgAAAAoAAAAZAAAAGQAAAAAAAAAzMzMAAAAAABQAAAAUAAAAGQAAABkAAAAAAAAABcAAAAUAAAAAAAAAAAAAAD/fwAA/38AAAAAAAAJAAAABAAAAAAAAAAeAAAAaAAAAAAAAAAAAAAAAAAAAAAAAAAAAAAAECcAABAnAAAAAAAAAAAAAAAAAAAAAAAAAAAAAAAAAAAAAAAAAAAAABQAAAAAAAAAwMD/AAAAAABkAAAAMgAAAAAAAABkAAAAAAAAAH9/fwAKAAAAIgAAABgAAAAAAAAAAAAAAAAAAAAAAAAAAAAAAAAAAAAkAAAAJAAAAAAAAAAHAAAAAAAAAAAAAAAAAAAAAAAAAAAAAAAAAAAAf39/ACUAAABYAAAAAAAAAAAAAAAAAAAAAAAAAAAAAAAAAAAAAAAAAAAAAAAAAAAAAAAAAAAAAAA/AAAAAAAAAKCGAQAAAAAAAAAAAAAAAAAMAAAAAQAAAAAAAAAAAAAAAAAAAB8AAABUAAAAAAAABQAAAAEAAAAAAAAAAAAAAAAAAAAAAAAAAAAAAAAAAAAAAAAAAAAAAAB/f38AAAAAA8zMzADAwP8Af39/AAAAAAAAAAAAAAAAAAAAAAAAAAAAIQAAABgAAAAUAAAACAcAADgEAAAoIwAAUBkAABAAAAAmAAAACAAAAAEPAAAAAAAA"/>
               </a:ext>
             </a:extLst>
           </p:cNvSpPr>
@@ -1604,7 +1604,7 @@
             <a:spLocks noGrp="1" noChangeArrowheads="1"/>
             <a:extLst>
               <a:ext uri="smNativeData">
-                <pr:smNativeData xmlns:pr="smNativeData" xmlns="smNativeData" val="SMDATA_15_FUV5ZhMAAAAlAAAAZAAAAA0AAAAAkAAAAJAAAACQAAAAkAAAAAAAAAAAAAAAAAAAAAEAAABQAAAAAAAAAAAA4D8AAAAAAADgPwAAAAAAAOA/AAAAAAAA4D8AAAAAAADgPwAAAAAAAOA/AAAAAAAA4D8AAAAAAADgPwAAAAAAAOA/AAAAAAAA4D8CAAAAjAAAAAAAAAAAAAAAQoX0DP///wgAAAAAAAAAAAAAAAAAAAAAAAAAAAAAAAAAAAAAZAAAAAEAAABAAAAAAAAAAAAAAAAAAAAAAAAAAAAAAAAAAAAAAAAAAAAAAAAAAAAAAAAAAAAAAAAAAAAAAAAAAAAAAAAAAAAAAAAAAAAAAAAAAAAAAAAAAAAAAAAAAAAAFAAAADwAAAAAAAAAAAAAAAAAAAkUAAAAAQAAABQAAAAUAAAAFAAAAAEAAAAAAAAAZAAAAGQAAAAAAAAAZAAAAGQAAAAVAAAAYAAAAAAAAAAAAAAADwAAACADAAAAAAAAAAAAAAEAAACgMgAAVgcAAKr4//8BAAAAf39/AAEAAABkAAAAAAAAABQAAABAHwAAAAAAACYAAAAAAAAAwOD//wAAAAAmAAAAZAAAABYAAABMAAAAAAAAAAAAAAAEAAAAAAAAAAEAAABZWVkKAAAAACgAAAAoAAAAZAAAAGQAAAAAAAAAzMzMAAAAAABQAAAAUAAAAGQAAABkAAAAAAAAABcAAAAUAAAAAAAAAAAAAAD/fwAA/38AAAAAAAAJAAAABAAAAKMkqfweAAAAaAAAAAAAAAAAAAAAAAAAAAAAAAAAAAAAECcAABAnAAAAAAAAAAAAAAAAAAAAAAAAAAAAAAAAAAAAAAAAAAAAABQAAAAAAAAAwMD/AAAAAABkAAAAMgAAAAAAAABkAAAAAAAAAH9/fwAKAAAAIgAAABgAAAAAAAAAAAAAAAAAAAAAAAAAAAAAAAAAAAAkAAAAJAAAAAAAAAAHAAAAAAAAAAAAAAAAAAAAAAAAAAAAAAAAAAAAf39/ACUAAABYAAAAAAAAAAAAAAAAAAAAAAAAAAAAAAAAAAAAAAAAAAAAAAAAAAAAAAAAAAAAAAA/AAAAAAAAAKCGAQAAAAAAAAAAAAAAAAAMAAAAAQAAAAAAAAAAAAAAAAAAAB8AAABUAAAAAAAABQAAAAEAAAAAAAAAAAAAAAAAAAAAAAAAAAAAAAAAAAAAAAAAAAAAAAJ/f38AAAAAA8zMzADAwP8Af39/AAAAAAAAAAAAAAAAAAAAAAAAAAAAIQAAABgAAAAUAAAAOAQAALgaAAD4JQAACDQAABAAAAAmAAAACAAAAL0/AAAAAAAA"/>
+                <pr:smNativeData xmlns:pr="smNativeData" xmlns="smNativeData" val="SMDATA_15_9kV5ZhMAAAAlAAAAZAAAAA0AAAAAkAAAAJAAAACQAAAAkAAAAAAAAAAAAAAAAAAAAAEAAABQAAAAAAAAAAAA4D8AAAAAAADgPwAAAAAAAOA/AAAAAAAA4D8AAAAAAADgPwAAAAAAAOA/AAAAAAAA4D8AAAAAAADgPwAAAAAAAOA/AAAAAAAA4D8CAAAAjAAAAAAAAAAAAAAAQoX0DP///wgAAAAAAAAAAAAAAAAAAAAAAAAAAAAAAAAAAAAAZAAAAAEAAABAAAAAAAAAAAAAAAAAAAAAAAAAAAAAAAAAAAAAAAAAAAAAAAAAAAAAAAAAAAAAAAAAAAAAAAAAAAAAAAAAAAAAAAAAAAAAAAAAAAAAAAAAAAAAAAAAAAAAFAAAADwAAAAAAAAAAAAAAAAAAAkUAAAAAQAAABQAAAAUAAAAFAAAAAEAAAAAAAAAZAAAAGQAAAAAAAAAZAAAAGQAAAAVAAAAYAAAAAAAAAAAAAAADwAAACADAAAAAAAAAAAAAAEAAACgMgAAVgcAAKr4//8BAAAAf39/AAEAAABkAAAAAAAAABQAAABAHwAAAAAAACYAAAAAAAAAwOD//wAAAAAmAAAAZAAAABYAAABMAAAAAAAAAAAAAAAEAAAAAAAAAAEAAABZWVkKAAAAACgAAAAoAAAAZAAAAGQAAAAAAAAAzMzMAAAAAABQAAAAUAAAAGQAAABkAAAAAAAAABcAAAAUAAAAAAAAAAAAAAD/fwAA/38AAAAAAAAJAAAABAAAAKMkqfweAAAAaAAAAAAAAAAAAAAAAAAAAAAAAAAAAAAAECcAABAnAAAAAAAAAAAAAAAAAAAAAAAAAAAAAAAAAAAAAAAAAAAAABQAAAAAAAAAwMD/AAAAAABkAAAAMgAAAAAAAABkAAAAAAAAAH9/fwAKAAAAIgAAABgAAAAAAAAAAAAAAAAAAAAAAAAAAAAAAAAAAAAkAAAAJAAAAAAAAAAHAAAAAAAAAAAAAAAAAAAAAAAAAAAAAAAAAAAAf39/ACUAAABYAAAAAAAAAAAAAAAAAAAAAAAAAAAAAAAAAAAAAAAAAAAAAAAAAAAAAAAAAAAAAAA/AAAAAAAAAKCGAQAAAAAAAAAAAAAAAAAMAAAAAQAAAAAAAAAAAAAAAAAAAB8AAABUAAAAAAAABQAAAAEAAAAAAAAAAAAAAAAAAAAAAAAAAAAAAAAAAAAAAAAAAAAAAAJ/f38AAAAAA8zMzADAwP8Af39/AAAAAAAAAAAAAAAAAAAAAAAAAAAAIQAAABgAAAAUAAAAOAQAALgaAAD4JQAACDQAABAAAAAmAAAACAAAAL0/AAAAAAAA"/>
               </a:ext>
             </a:extLst>
           </p:cNvSpPr>
@@ -1681,7 +1681,7 @@
             <a:spLocks noGrp="1" noChangeArrowheads="1"/>
             <a:extLst>
               <a:ext uri="smNativeData">
-                <pr:smNativeData xmlns:pr="smNativeData" xmlns="smNativeData" val="SMDATA_15_FUV5ZhMAAAAlAAAACwAAAA0AAAAACAcAADgEAAAoIwAAUBkAAAAAAAAAAAAAAAAAAAEAAABQAAAAAAAAAAAA4D8AAAAAAADgPwAAAAAAAOA/AAAAAAAA4D8AAAAAAADgPwAAAAAAAOA/AAAAAAAA4D8AAAAAAADgPwAAAAAAAOA/AAAAAAAA4D8CAAAAjAAAAAAAAAAAAAAAQoX0DP///wgAAAAAAAAAAAAAAAAAAAAAAAAAAAAAAAAAAAAAZAAAAAEAAABAAAAAAAAAAAAAAAAAAAAAAAAAAAAAAAAAAAAAAAAAAAAAAAAAAAAAAAAAAAAAAAAAAAAAAAAAAAAAAAAAAAAAAAAAAAAAAAAAAAAAAAAAAAAAAAAAAAAAFAAAADwAAAABAAAAAAAAAAAAAAAPAAAAAQAAACMAAAAjAAAAIwAAAB4AAAAAAAAASwAAAEsAAAAAAAAASwAAAEsAAAAVAAAAYAAAAAAAAAAAAAAADwAAACADAAAAAAAAAAAAAAEAAACgMgAAVgcAAKr4//8BAAAAf39/AAEAAABkAAAAAAAAABQAAABAHwAAAAAAACYAAAAAAAAAwOD//wAAAAAmAAAAZAAAABYAAABMAAAAAAAAAAAAAAAEAAAAAAAAAAEAAABZWVkKAAAAACgAAAAoAAAAZAAAAGQAAAAAAAAAzMzMAAAAAABQAAAAUAAAAGQAAABkAAAAAAAAABcAAAAUAAAAAAAAAAAAAAD/fwAA/38AAAAAAAAJAAAABAAAAAAAAAAeAAAAaAAAAAAAAAAAAAAAAAAAAAAAAAAAAAAAECcAABAnAAAAAAAAAAAAAAAAAAAAAAAAAAAAAAAAAAAAAAAAAAAAABQAAAAAAAAAwMD/AAAAAABkAAAAMgAAAAAAAABkAAAAAAAAAH9/fwAKAAAAIgAAABgAAAAAAAAAAAAAAAAAAAAAAAAAAAAAAAAAAAAkAAAAJAAAAAAAAAAHAAAAAAAAAAAAAAAAAAAAAAAAAAAAAAAAAAAAf39/ACUAAABYAAAAAAAAAAAAAAAAAAAAAAAAAAAAAAAAAAAAAAAAAAAAAAAAAAAAAAAAAAAAAAA/AAAAAAAAAKCGAQAAAAAAAAAAAAAAAAAMAAAAAQAAAAAAAAAAAAAAAAAAAB8AAABUAAAAAAAABQAAAAEAAAAAAAAAAAAAAAAAAAAAAAAAAAAAAAAAAAAAAAAAAAAAAAB/f38AAAAAA8zMzADAwP8Af39/AAAAAAAAAAAAAAAAAAAAAAAAAAAAIQAAABgAAAAUAAAACAcAADgEAAAoIwAAUBkAABAAAAAmAAAACAAAAAEPAAAAAAAA"/>
+                <pr:smNativeData xmlns:pr="smNativeData" xmlns="smNativeData" val="SMDATA_15_9kV5ZhMAAAAlAAAACwAAAA0AAAAACAcAADgEAAAoIwAAUBkAAAAAAAAAAAAAAAAAAAEAAABQAAAAAAAAAAAA4D8AAAAAAADgPwAAAAAAAOA/AAAAAAAA4D8AAAAAAADgPwAAAAAAAOA/AAAAAAAA4D8AAAAAAADgPwAAAAAAAOA/AAAAAAAA4D8CAAAAjAAAAAAAAAAAAAAAQoX0DP///wgAAAAAAAAAAAAAAAAAAAAAAAAAAAAAAAAAAAAAZAAAAAEAAABAAAAAAAAAAAAAAAAAAAAAAAAAAAAAAAAAAAAAAAAAAAAAAAAAAAAAAAAAAAAAAAAAAAAAAAAAAAAAAAAAAAAAAAAAAAAAAAAAAAAAAAAAAAAAAAAAAAAAFAAAADwAAAABAAAAAAAAAAAAAAAPAAAAAQAAACMAAAAjAAAAIwAAAB4AAAAAAAAASwAAAEsAAAAAAAAASwAAAEsAAAAVAAAAYAAAAAAAAAAAAAAADwAAACADAAAAAAAAAAAAAAEAAACgMgAAVgcAAKr4//8BAAAAf39/AAEAAABkAAAAAAAAABQAAABAHwAAAAAAACYAAAAAAAAAwOD//wAAAAAmAAAAZAAAABYAAABMAAAAAAAAAAAAAAAEAAAAAAAAAAEAAABZWVkKAAAAACgAAAAoAAAAZAAAAGQAAAAAAAAAzMzMAAAAAABQAAAAUAAAAGQAAABkAAAAAAAAABcAAAAUAAAAAAAAAAAAAAD/fwAA/38AAAAAAAAJAAAABAAAAAAAAAAeAAAAaAAAAAAAAAAAAAAAAAAAAAAAAAAAAAAAECcAABAnAAAAAAAAAAAAAAAAAAAAAAAAAAAAAAAAAAAAAAAAAAAAABQAAAAAAAAAwMD/AAAAAABkAAAAMgAAAAAAAABkAAAAAAAAAH9/fwAKAAAAIgAAABgAAAAAAAAAAAAAAAAAAAAAAAAAAAAAAAAAAAAkAAAAJAAAAAAAAAAHAAAAAAAAAAAAAAAAAAAAAAAAAAAAAAAAAAAAf39/ACUAAABYAAAAAAAAAAAAAAAAAAAAAAAAAAAAAAAAAAAAAAAAAAAAAAAAAAAAAAAAAAAAAAA/AAAAAAAAAKCGAQAAAAAAAAAAAAAAAAAMAAAAAQAAAAAAAAAAAAAAAAAAAB8AAABUAAAAAAAABQAAAAEAAAAAAAAAAAAAAAAAAAAAAAAAAAAAAAAAAAAAAAAAAAAAAAB/f38AAAAAA8zMzADAwP8Af39/AAAAAAAAAAAAAAAAAAAAAAAAAAAAIQAAABgAAAAUAAAACAcAADgEAAAoIwAAUBkAABAAAAAmAAAACAAAAAEPAAAAAAAA"/>
               </a:ext>
             </a:extLst>
           </p:cNvSpPr>
@@ -1727,7 +1727,7 @@
             <a:spLocks noGrp="1" noChangeArrowheads="1"/>
             <a:extLst>
               <a:ext uri="smNativeData">
-                <pr:smNativeData xmlns:pr="smNativeData" xmlns="smNativeData" val="SMDATA_15_FUV5ZhMAAAAlAAAAZAAAAA0AAAAAkAAAAJAAAACQAAAAkAAAAAAAAAAAAAAAAAAAAAEAAABQAAAAAAAAAAAA4D8AAAAAAADgPwAAAAAAAOA/AAAAAAAA4D8AAAAAAADgPwAAAAAAAOA/AAAAAAAA4D8AAAAAAADgPwAAAAAAAOA/AAAAAAAA4D8CAAAAjAAAAAAAAAAAAAAAQoX0DP///wgAAAAAAAAAAAAAAAAAAAAAAAAAAAAAAAAAAAAAZAAAAAEAAABAAAAAAAAAAAAAAAAAAAAAAAAAAAAAAAAAAAAAAAAAAAAAAAAAAAAAAAAAAAAAAAAAAAAAAAAAAAAAAAAAAAAAAAAAAAAAAAAAAAAAAAAAAAAAAAAAAAAAFAAAADwAAAAAAAAAAAAAAAAAAAkUAAAAAQAAABQAAAAUAAAAFAAAAAEAAAAAAAAAZAAAAGQAAAAAAAAAZAAAAGQAAAAVAAAAYAAAAAAAAAAAAAAADwAAACADAAAAAAAAAAAAAAEAAACgMgAAVgcAAKr4//8BAAAAf39/AAEAAABkAAAAAAAAABQAAABAHwAAAAAAACYAAAAAAAAAwOD//wAAAAAmAAAAZAAAABYAAABMAAAAAAAAAAAAAAAEAAAAAAAAAAEAAABZWVkKAAAAACgAAAAoAAAAZAAAAGQAAAAAAAAAzMzMAAAAAABQAAAAUAAAAGQAAABkAAAAAAAAABcAAAAUAAAAAAAAAAAAAAD/fwAA/38AAAAAAAAJAAAABAAAAF8AYAAeAAAAaAAAAAAAAAAAAAAAAAAAAAAAAAAAAAAAECcAABAnAAAAAAAAAAAAAAAAAAAAAAAAAAAAAAAAAAAAAAAAAAAAABQAAAAAAAAAwMD/AAAAAABkAAAAMgAAAAAAAABkAAAAAAAAAH9/fwAKAAAAIgAAABgAAAAAAAAAAAAAAAAAAAAAAAAAAAAAAAAAAAAkAAAAJAAAAAAAAAAHAAAAAAAAAAAAAAAAAAAAAAAAAAAAAAAAAAAAf39/ACUAAABYAAAAAAAAAAAAAAAAAAAAAAAAAAAAAAAAAAAAAAAAAAAAAAAAAAAAAAAAAAAAAAA/AAAAAAAAAKCGAQAAAAAAAAAAAAAAAAAMAAAAAQAAAAAAAAAAAAAAAAAAAB8AAABUAAAAAAAABQAAAAEAAAAAAAAAAAAAAAAAAAAAAAAAAAAAAAAAAAAAAAAAAAAAAAJ/f38AAAAAA8zMzADAwP8Af39/AAAAAAAAAAAAAAAAAAAAAAAAAAAAIQAAABgAAAAUAAAAOAQAALgaAAD4JQAACDQAABAAAAAmAAAACAAAAL0/AAAAAAAA"/>
+                <pr:smNativeData xmlns:pr="smNativeData" xmlns="smNativeData" val="SMDATA_15_9kV5ZhMAAAAlAAAAZAAAAA0AAAAAkAAAAJAAAACQAAAAkAAAAAAAAAAAAAAAAAAAAAEAAABQAAAAAAAAAAAA4D8AAAAAAADgPwAAAAAAAOA/AAAAAAAA4D8AAAAAAADgPwAAAAAAAOA/AAAAAAAA4D8AAAAAAADgPwAAAAAAAOA/AAAAAAAA4D8CAAAAjAAAAAAAAAAAAAAAQoX0DP///wgAAAAAAAAAAAAAAAAAAAAAAAAAAAAAAAAAAAAAZAAAAAEAAABAAAAAAAAAAAAAAAAAAAAAAAAAAAAAAAAAAAAAAAAAAAAAAAAAAAAAAAAAAAAAAAAAAAAAAAAAAAAAAAAAAAAAAAAAAAAAAAAAAAAAAAAAAAAAAAAAAAAAFAAAADwAAAAAAAAAAAAAAAAAAAkUAAAAAQAAABQAAAAUAAAAFAAAAAEAAAAAAAAAZAAAAGQAAAAAAAAAZAAAAGQAAAAVAAAAYAAAAAAAAAAAAAAADwAAACADAAAAAAAAAAAAAAEAAACgMgAAVgcAAKr4//8BAAAAf39/AAEAAABkAAAAAAAAABQAAABAHwAAAAAAACYAAAAAAAAAwOD//wAAAAAmAAAAZAAAABYAAABMAAAAAAAAAAAAAAAEAAAAAAAAAAEAAABZWVkKAAAAACgAAAAoAAAAZAAAAGQAAAAAAAAAzMzMAAAAAABQAAAAUAAAAGQAAABkAAAAAAAAABcAAAAUAAAAAAAAAAAAAAD/fwAA/38AAAAAAAAJAAAABAAAAF8AYAAeAAAAaAAAAAAAAAAAAAAAAAAAAAAAAAAAAAAAECcAABAnAAAAAAAAAAAAAAAAAAAAAAAAAAAAAAAAAAAAAAAAAAAAABQAAAAAAAAAwMD/AAAAAABkAAAAMgAAAAAAAABkAAAAAAAAAH9/fwAKAAAAIgAAABgAAAAAAAAAAAAAAAAAAAAAAAAAAAAAAAAAAAAkAAAAJAAAAAAAAAAHAAAAAAAAAAAAAAAAAAAAAAAAAAAAAAAAAAAAf39/ACUAAABYAAAAAAAAAAAAAAAAAAAAAAAAAAAAAAAAAAAAAAAAAAAAAAAAAAAAAAAAAAAAAAA/AAAAAAAAAKCGAQAAAAAAAAAAAAAAAAAMAAAAAQAAAAAAAAAAAAAAAAAAAB8AAABUAAAAAAAABQAAAAEAAAAAAAAAAAAAAAAAAAAAAAAAAAAAAAAAAAAAAAAAAAAAAAJ/f38AAAAAA8zMzADAwP8Af39/AAAAAAAAAAAAAAAAAAAAAAAAAAAAIQAAABgAAAAUAAAAOAQAALgaAAD4JQAACDQAABAAAAAmAAAACAAAAL0/AAAAAAAA"/>
               </a:ext>
             </a:extLst>
           </p:cNvSpPr>
@@ -1804,7 +1804,7 @@
             <a:spLocks noGrp="1" noChangeArrowheads="1"/>
             <a:extLst>
               <a:ext uri="smNativeData">
-                <pr:smNativeData xmlns:pr="smNativeData" xmlns="smNativeData" val="SMDATA_15_FUV5ZhMAAAAlAAAACwAAAA0AAAAACAcAADgEAAAoIwAAUBkAAAAAAAAAAAAAAAAAAAEAAABQAAAAAAAAAAAA4D8AAAAAAADgPwAAAAAAAOA/AAAAAAAA4D8AAAAAAADgPwAAAAAAAOA/AAAAAAAA4D8AAAAAAADgPwAAAAAAAOA/AAAAAAAA4D8CAAAAjAAAAAAAAAAAAAAAQoX0DP///wgAAAAAAAAAAAAAAAAAAAAAAAAAAAAAAAAAAAAAZAAAAAEAAABAAAAAAAAAAAAAAAAAAAAAAAAAAAAAAAAAAAAAAAAAAAAAAAAAAAAAAAAAAAAAAAAAAAAAAAAAAAAAAAAAAAAAAAAAAAAAAAAAAAAAAAAAAAAAAAAAAAAAFAAAADwAAAABAAAAAAAAAAAAAAAPAAAAAQAAACMAAAAjAAAAIwAAAB4AAAAAAAAASwAAAEsAAAAAAAAASwAAAEsAAAAVAAAAYAAAAAAAAAAAAAAADwAAACADAAAAAAAAAAAAAAEAAACgMgAAVgcAAKr4//8BAAAAf39/AAEAAABkAAAAAAAAABQAAABAHwAAAAAAACYAAAAAAAAAwOD//wAAAAAmAAAAZAAAABYAAABMAAAAAAAAAAAAAAAEAAAAAAAAAAEAAABZWVkKAAAAACgAAAAoAAAAZAAAAGQAAAAAAAAAzMzMAAAAAABQAAAAUAAAAGQAAABkAAAAAAAAABcAAAAUAAAAAAAAAAAAAAD/fwAA/38AAAAAAAAJAAAABAAAAAAAAAAeAAAAaAAAAAAAAAAAAAAAAAAAAAAAAAAAAAAAECcAABAnAAAAAAAAAAAAAAAAAAAAAAAAAAAAAAAAAAAAAAAAAAAAABQAAAAAAAAAwMD/AAAAAABkAAAAMgAAAAAAAABkAAAAAAAAAH9/fwAKAAAAIgAAABgAAAAAAAAAAAAAAAAAAAAAAAAAAAAAAAAAAAAkAAAAJAAAAAAAAAAHAAAAAAAAAAAAAAAAAAAAAAAAAAAAAAAAAAAAf39/ACUAAABYAAAAAAAAAAAAAAAAAAAAAAAAAAAAAAAAAAAAAAAAAAAAAAAAAAAAAAAAAAAAAAA/AAAAAAAAAKCGAQAAAAAAAAAAAAAAAAAMAAAAAQAAAAAAAAAAAAAAAAAAAB8AAABUAAAAAAAABQAAAAEAAAAAAAAAAAAAAAAAAAAAAAAAAAAAAAAAAAAAAAAAAAAAAAB/f38AAAAAA8zMzADAwP8Af39/AAAAAAAAAAAAAAAAAAAAAAAAAAAAIQAAABgAAAAUAAAACAcAADgEAAAoIwAAUBkAABAAAAAmAAAACAAAAAEPAAAAAAAA"/>
+                <pr:smNativeData xmlns:pr="smNativeData" xmlns="smNativeData" val="SMDATA_15_9kV5ZhMAAAAlAAAACwAAAA0AAAAACAcAADgEAAAoIwAAUBkAAAAAAAAAAAAAAAAAAAEAAABQAAAAAAAAAAAA4D8AAAAAAADgPwAAAAAAAOA/AAAAAAAA4D8AAAAAAADgPwAAAAAAAOA/AAAAAAAA4D8AAAAAAADgPwAAAAAAAOA/AAAAAAAA4D8CAAAAjAAAAAAAAAAAAAAAQoX0DP///wgAAAAAAAAAAAAAAAAAAAAAAAAAAAAAAAAAAAAAZAAAAAEAAABAAAAAAAAAAAAAAAAAAAAAAAAAAAAAAAAAAAAAAAAAAAAAAAAAAAAAAAAAAAAAAAAAAAAAAAAAAAAAAAAAAAAAAAAAAAAAAAAAAAAAAAAAAAAAAAAAAAAAFAAAADwAAAABAAAAAAAAAAAAAAAPAAAAAQAAACMAAAAjAAAAIwAAAB4AAAAAAAAASwAAAEsAAAAAAAAASwAAAEsAAAAVAAAAYAAAAAAAAAAAAAAADwAAACADAAAAAAAAAAAAAAEAAACgMgAAVgcAAKr4//8BAAAAf39/AAEAAABkAAAAAAAAABQAAABAHwAAAAAAACYAAAAAAAAAwOD//wAAAAAmAAAAZAAAABYAAABMAAAAAAAAAAAAAAAEAAAAAAAAAAEAAABZWVkKAAAAACgAAAAoAAAAZAAAAGQAAAAAAAAAzMzMAAAAAABQAAAAUAAAAGQAAABkAAAAAAAAABcAAAAUAAAAAAAAAAAAAAD/fwAA/38AAAAAAAAJAAAABAAAAAAAAAAeAAAAaAAAAAAAAAAAAAAAAAAAAAAAAAAAAAAAECcAABAnAAAAAAAAAAAAAAAAAAAAAAAAAAAAAAAAAAAAAAAAAAAAABQAAAAAAAAAwMD/AAAAAABkAAAAMgAAAAAAAABkAAAAAAAAAH9/fwAKAAAAIgAAABgAAAAAAAAAAAAAAAAAAAAAAAAAAAAAAAAAAAAkAAAAJAAAAAAAAAAHAAAAAAAAAAAAAAAAAAAAAAAAAAAAAAAAAAAAf39/ACUAAABYAAAAAAAAAAAAAAAAAAAAAAAAAAAAAAAAAAAAAAAAAAAAAAAAAAAAAAAAAAAAAAA/AAAAAAAAAKCGAQAAAAAAAAAAAAAAAAAMAAAAAQAAAAAAAAAAAAAAAAAAAB8AAABUAAAAAAAABQAAAAEAAAAAAAAAAAAAAAAAAAAAAAAAAAAAAAAAAAAAAAAAAAAAAAB/f38AAAAAA8zMzADAwP8Af39/AAAAAAAAAAAAAAAAAAAAAAAAAAAAIQAAABgAAAAUAAAACAcAADgEAAAoIwAAUBkAABAAAAAmAAAACAAAAAEPAAAAAAAA"/>
               </a:ext>
             </a:extLst>
           </p:cNvSpPr>
@@ -1850,7 +1850,7 @@
             <a:spLocks noGrp="1" noChangeArrowheads="1"/>
             <a:extLst>
               <a:ext uri="smNativeData">
-                <pr:smNativeData xmlns:pr="smNativeData" xmlns="smNativeData" val="SMDATA_15_FUV5ZhMAAAAlAAAAZAAAAA0AAAAAkAAAAJAAAACQAAAAkAAAAAAAAAAAAAAAAAAAAAEAAABQAAAAAAAAAAAA4D8AAAAAAADgPwAAAAAAAOA/AAAAAAAA4D8AAAAAAADgPwAAAAAAAOA/AAAAAAAA4D8AAAAAAADgPwAAAAAAAOA/AAAAAAAA4D8CAAAAjAAAAAAAAAAAAAAAQoX0DP///wgAAAAAAAAAAAAAAAAAAAAAAAAAAAAAAAAAAAAAZAAAAAEAAABAAAAAAAAAAAAAAAAAAAAAAAAAAAAAAAAAAAAAAAAAAAAAAAAAAAAAAAAAAAAAAAAAAAAAAAAAAAAAAAAAAAAAAAAAAAAAAAAAAAAAAAAAAAAAAAAAAAAAFAAAADwAAAAAAAAAAAAAAAAAAAkUAAAAAQAAABQAAAAUAAAAFAAAAAEAAAAAAAAAZAAAAGQAAAAAAAAAZAAAAGQAAAAVAAAAYAAAAAAAAAAAAAAADwAAACADAAAAAAAAAAAAAAEAAACgMgAAVgcAAKr4//8BAAAAf39/AAEAAABkAAAAAAAAABQAAABAHwAAAAAAACYAAAAAAAAAwOD//wAAAAAmAAAAZAAAABYAAABMAAAAAAAAAAAAAAAEAAAAAAAAAAEAAABZWVkKAAAAACgAAAAoAAAAZAAAAGQAAAAAAAAAzMzMAAAAAABQAAAAUAAAAGQAAABkAAAAAAAAABcAAAAUAAAAAAAAAAAAAAD/fwAA/38AAAAAAAAJAAAABAAAAF8AYAAeAAAAaAAAAAAAAAAAAAAAAAAAAAAAAAAAAAAAECcAABAnAAAAAAAAAAAAAAAAAAAAAAAAAAAAAAAAAAAAAAAAAAAAABQAAAAAAAAAwMD/AAAAAABkAAAAMgAAAAAAAABkAAAAAAAAAH9/fwAKAAAAIgAAABgAAAAAAAAAAAAAAAAAAAAAAAAAAAAAAAAAAAAkAAAAJAAAAAAAAAAHAAAAAAAAAAAAAAAAAAAAAAAAAAAAAAAAAAAAf39/ACUAAABYAAAAAAAAAAAAAAAAAAAAAAAAAAAAAAAAAAAAAAAAAAAAAAAAAAAAAAAAAAAAAAA/AAAAAAAAAKCGAQAAAAAAAAAAAAAAAAAMAAAAAQAAAAAAAAAAAAAAAAAAAB8AAABUAAAAAAAABQAAAAEAAAAAAAAAAAAAAAAAAAAAAAAAAAAAAAAAAAAAAAAAAAAAAAJ/f38AAAAAA8zMzADAwP8Af39/AAAAAAAAAAAAAAAAAAAAAAAAAAAAIQAAABgAAAAUAAAAOAQAALgaAAD4JQAACDQAABAAAAAmAAAACAAAAL0/AAAAAAAA"/>
+                <pr:smNativeData xmlns:pr="smNativeData" xmlns="smNativeData" val="SMDATA_15_9kV5ZhMAAAAlAAAAZAAAAA0AAAAAkAAAAJAAAACQAAAAkAAAAAAAAAAAAAAAAAAAAAEAAABQAAAAAAAAAAAA4D8AAAAAAADgPwAAAAAAAOA/AAAAAAAA4D8AAAAAAADgPwAAAAAAAOA/AAAAAAAA4D8AAAAAAADgPwAAAAAAAOA/AAAAAAAA4D8CAAAAjAAAAAAAAAAAAAAAQoX0DP///wgAAAAAAAAAAAAAAAAAAAAAAAAAAAAAAAAAAAAAZAAAAAEAAABAAAAAAAAAAAAAAAAAAAAAAAAAAAAAAAAAAAAAAAAAAAAAAAAAAAAAAAAAAAAAAAAAAAAAAAAAAAAAAAAAAAAAAAAAAAAAAAAAAAAAAAAAAAAAAAAAAAAAFAAAADwAAAAAAAAAAAAAAAAAAAkUAAAAAQAAABQAAAAUAAAAFAAAAAEAAAAAAAAAZAAAAGQAAAAAAAAAZAAAAGQAAAAVAAAAYAAAAAAAAAAAAAAADwAAACADAAAAAAAAAAAAAAEAAACgMgAAVgcAAKr4//8BAAAAf39/AAEAAABkAAAAAAAAABQAAABAHwAAAAAAACYAAAAAAAAAwOD//wAAAAAmAAAAZAAAABYAAABMAAAAAAAAAAAAAAAEAAAAAAAAAAEAAABZWVkKAAAAACgAAAAoAAAAZAAAAGQAAAAAAAAAzMzMAAAAAABQAAAAUAAAAGQAAABkAAAAAAAAABcAAAAUAAAAAAAAAAAAAAD/fwAA/38AAAAAAAAJAAAABAAAAF8AYAAeAAAAaAAAAAAAAAAAAAAAAAAAAAAAAAAAAAAAECcAABAnAAAAAAAAAAAAAAAAAAAAAAAAAAAAAAAAAAAAAAAAAAAAABQAAAAAAAAAwMD/AAAAAABkAAAAMgAAAAAAAABkAAAAAAAAAH9/fwAKAAAAIgAAABgAAAAAAAAAAAAAAAAAAAAAAAAAAAAAAAAAAAAkAAAAJAAAAAAAAAAHAAAAAAAAAAAAAAAAAAAAAAAAAAAAAAAAAAAAf39/ACUAAABYAAAAAAAAAAAAAAAAAAAAAAAAAAAAAAAAAAAAAAAAAAAAAAAAAAAAAAAAAAAAAAA/AAAAAAAAAKCGAQAAAAAAAAAAAAAAAAAMAAAAAQAAAAAAAAAAAAAAAAAAAB8AAABUAAAAAAAABQAAAAEAAAAAAAAAAAAAAAAAAAAAAAAAAAAAAAAAAAAAAAAAAAAAAAJ/f38AAAAAA8zMzADAwP8Af39/AAAAAAAAAAAAAAAAAAAAAAAAAAAAIQAAABgAAAAUAAAAOAQAALgaAAD4JQAACDQAABAAAAAmAAAACAAAAL0/AAAAAAAA"/>
               </a:ext>
             </a:extLst>
           </p:cNvSpPr>
@@ -1927,7 +1927,7 @@
             <a:spLocks noGrp="1" noChangeArrowheads="1"/>
             <a:extLst>
               <a:ext uri="smNativeData">
-                <pr:smNativeData xmlns:pr="smNativeData" xmlns="smNativeData" val="SMDATA_15_FUV5ZhMAAAAlAAAACwAAAA0AAAAACAcAADgEAAAoIwAAUBkAAAAAAAAAAAAAAAAAAAEAAABQAAAAAAAAAAAA4D8AAAAAAADgPwAAAAAAAOA/AAAAAAAA4D8AAAAAAADgPwAAAAAAAOA/AAAAAAAA4D8AAAAAAADgPwAAAAAAAOA/AAAAAAAA4D8CAAAAjAAAAAAAAAAAAAAAQoX0DP///wgAAAAAAAAAAAAAAAAAAAAAAAAAAAAAAAAAAAAAZAAAAAEAAABAAAAAAAAAAAAAAAAAAAAAAAAAAAAAAAAAAAAAAAAAAAAAAAAAAAAAAAAAAAAAAAAAAAAAAAAAAAAAAAAAAAAAAAAAAAAAAAAAAAAAAAAAAAAAAAAAAAAAFAAAADwAAAABAAAAAAAAAAAAAAAPAAAAAQAAACMAAAAjAAAAIwAAAB4AAAAAAAAASwAAAEsAAAAAAAAASwAAAEsAAAAVAAAAYAAAAAAAAAAAAAAADwAAACADAAAAAAAAAAAAAAEAAACgMgAAVgcAAKr4//8BAAAAf39/AAEAAABkAAAAAAAAABQAAABAHwAAAAAAACYAAAAAAAAAwOD//wAAAAAmAAAAZAAAABYAAABMAAAAAAAAAAAAAAAEAAAAAAAAAAEAAABZWVkKAAAAACgAAAAoAAAAZAAAAGQAAAAAAAAAzMzMAAAAAABQAAAAUAAAAGQAAABkAAAAAAAAABcAAAAUAAAAAAAAAAAAAAD/fwAA/38AAAAAAAAJAAAABAAAAAAAAAAeAAAAaAAAAAAAAAAAAAAAAAAAAAAAAAAAAAAAECcAABAnAAAAAAAAAAAAAAAAAAAAAAAAAAAAAAAAAAAAAAAAAAAAABQAAAAAAAAAwMD/AAAAAABkAAAAMgAAAAAAAABkAAAAAAAAAH9/fwAKAAAAIgAAABgAAAAAAAAAAAAAAAAAAAAAAAAAAAAAAAAAAAAkAAAAJAAAAAAAAAAHAAAAAAAAAAAAAAAAAAAAAAAAAAAAAAAAAAAAf39/ACUAAABYAAAAAAAAAAAAAAAAAAAAAAAAAAAAAAAAAAAAAAAAAAAAAAAAAAAAAAAAAAAAAAA/AAAAAAAAAKCGAQAAAAAAAAAAAAAAAAAMAAAAAQAAAAAAAAAAAAAAAAAAAB8AAABUAAAAAAAABQAAAAEAAAAAAAAAAAAAAAAAAAAAAAAAAAAAAAAAAAAAAAAAAAAAAAB/f38AAAAAA8zMzADAwP8Af39/AAAAAAAAAAAAAAAAAAAAAAAAAAAAIQAAABgAAAAUAAAACAcAADgEAAAoIwAAUBkAABAAAAAmAAAACAAAAAEPAAAAAAAA"/>
+                <pr:smNativeData xmlns:pr="smNativeData" xmlns="smNativeData" val="SMDATA_15_9kV5ZhMAAAAlAAAACwAAAA0AAAAACAcAADgEAAAoIwAAUBkAAAAAAAAAAAAAAAAAAAEAAABQAAAAAAAAAAAA4D8AAAAAAADgPwAAAAAAAOA/AAAAAAAA4D8AAAAAAADgPwAAAAAAAOA/AAAAAAAA4D8AAAAAAADgPwAAAAAAAOA/AAAAAAAA4D8CAAAAjAAAAAAAAAAAAAAAQoX0DP///wgAAAAAAAAAAAAAAAAAAAAAAAAAAAAAAAAAAAAAZAAAAAEAAABAAAAAAAAAAAAAAAAAAAAAAAAAAAAAAAAAAAAAAAAAAAAAAAAAAAAAAAAAAAAAAAAAAAAAAAAAAAAAAAAAAAAAAAAAAAAAAAAAAAAAAAAAAAAAAAAAAAAAFAAAADwAAAABAAAAAAAAAAAAAAAPAAAAAQAAACMAAAAjAAAAIwAAAB4AAAAAAAAASwAAAEsAAAAAAAAASwAAAEsAAAAVAAAAYAAAAAAAAAAAAAAADwAAACADAAAAAAAAAAAAAAEAAACgMgAAVgcAAKr4//8BAAAAf39/AAEAAABkAAAAAAAAABQAAABAHwAAAAAAACYAAAAAAAAAwOD//wAAAAAmAAAAZAAAABYAAABMAAAAAAAAAAAAAAAEAAAAAAAAAAEAAABZWVkKAAAAACgAAAAoAAAAZAAAAGQAAAAAAAAAzMzMAAAAAABQAAAAUAAAAGQAAABkAAAAAAAAABcAAAAUAAAAAAAAAAAAAAD/fwAA/38AAAAAAAAJAAAABAAAAAAAAAAeAAAAaAAAAAAAAAAAAAAAAAAAAAAAAAAAAAAAECcAABAnAAAAAAAAAAAAAAAAAAAAAAAAAAAAAAAAAAAAAAAAAAAAABQAAAAAAAAAwMD/AAAAAABkAAAAMgAAAAAAAABkAAAAAAAAAH9/fwAKAAAAIgAAABgAAAAAAAAAAAAAAAAAAAAAAAAAAAAAAAAAAAAkAAAAJAAAAAAAAAAHAAAAAAAAAAAAAAAAAAAAAAAAAAAAAAAAAAAAf39/ACUAAABYAAAAAAAAAAAAAAAAAAAAAAAAAAAAAAAAAAAAAAAAAAAAAAAAAAAAAAAAAAAAAAA/AAAAAAAAAKCGAQAAAAAAAAAAAAAAAAAMAAAAAQAAAAAAAAAAAAAAAAAAAB8AAABUAAAAAAAABQAAAAEAAAAAAAAAAAAAAAAAAAAAAAAAAAAAAAAAAAAAAAAAAAAAAAB/f38AAAAAA8zMzADAwP8Af39/AAAAAAAAAAAAAAAAAAAAAAAAAAAAIQAAABgAAAAUAAAACAcAADgEAAAoIwAAUBkAABAAAAAmAAAACAAAAAEPAAAAAAAA"/>
               </a:ext>
             </a:extLst>
           </p:cNvSpPr>
@@ -1973,7 +1973,7 @@
             <a:spLocks noGrp="1" noChangeArrowheads="1"/>
             <a:extLst>
               <a:ext uri="smNativeData">
-                <pr:smNativeData xmlns:pr="smNativeData" xmlns="smNativeData" val="SMDATA_15_FUV5ZhMAAAAlAAAAZAAAAA0AAAAAkAAAAJAAAACQAAAAkAAAAAAAAAAAAAAAAAAAAAEAAABQAAAAAAAAAAAA4D8AAAAAAADgPwAAAAAAAOA/AAAAAAAA4D8AAAAAAADgPwAAAAAAAOA/AAAAAAAA4D8AAAAAAADgPwAAAAAAAOA/AAAAAAAA4D8CAAAAjAAAAAAAAAAAAAAAQoX0DP///wgAAAAAAAAAAAAAAAAAAAAAAAAAAAAAAAAAAAAAZAAAAAEAAABAAAAAAAAAAAAAAAAAAAAAAAAAAAAAAAAAAAAAAAAAAAAAAAAAAAAAAAAAAAAAAAAAAAAAAAAAAAAAAAAAAAAAAAAAAAAAAAAAAAAAAAAAAAAAAAAAAAAAFAAAADwAAAAAAAAAAAAAAAAAAAkUAAAAAQAAABQAAAAUAAAAFAAAAAEAAAAAAAAAZAAAAGQAAAAAAAAAZAAAAGQAAAAVAAAAYAAAAAAAAAAAAAAADwAAACADAAAAAAAAAAAAAAEAAACgMgAAVgcAAKr4//8BAAAAf39/AAEAAABkAAAAAAAAABQAAABAHwAAAAAAACYAAAAAAAAAwOD//wAAAAAmAAAAZAAAABYAAABMAAAAAAAAAAAAAAAEAAAAAAAAAAEAAABZWVkKAAAAACgAAAAoAAAAZAAAAGQAAAAAAAAAzMzMAAAAAABQAAAAUAAAAGQAAABkAAAAAAAAABcAAAAUAAAAAAAAAAAAAAD/fwAA/38AAAAAAAAJAAAABAAAAPDbzXceAAAAaAAAAAAAAAAAAAAAAAAAAAAAAAAAAAAAECcAABAnAAAAAAAAAAAAAAAAAAAAAAAAAAAAAAAAAAAAAAAAAAAAABQAAAAAAAAAwMD/AAAAAABkAAAAMgAAAAAAAABkAAAAAAAAAH9/fwAKAAAAIgAAABgAAAAAAAAAAAAAAAAAAAAAAAAAAAAAAAAAAAAkAAAAJAAAAAAAAAAHAAAAAAAAAAAAAAAAAAAAAAAAAAAAAAAAAAAAf39/ACUAAABYAAAAAAAAAAAAAAAAAAAAAAAAAAAAAAAAAAAAAAAAAAAAAAAAAAAAAAAAAAAAAAA/AAAAAAAAAKCGAQAAAAAAAAAAAAAAAAAMAAAAAQAAAAAAAAAAAAAAAAAAAB8AAABUAAAAAAAABQAAAAEAAAAAAAAAAAAAAAAAAAAAAAAAAAAAAAAAAAAAAAAAAAAAAAJ/f38AAAAAA8zMzADAwP8Af39/AAAAAAAAAAAAAAAAAAAAAAAAAAAAIQAAABgAAAAUAAAAOAQAALgaAAD4JQAACDQAABAAAAAmAAAACAAAAL0/AAAAAAAA"/>
+                <pr:smNativeData xmlns:pr="smNativeData" xmlns="smNativeData" val="SMDATA_15_9kV5ZhMAAAAlAAAAZAAAAA0AAAAAkAAAAJAAAACQAAAAkAAAAAAAAAAAAAAAAAAAAAEAAABQAAAAAAAAAAAA4D8AAAAAAADgPwAAAAAAAOA/AAAAAAAA4D8AAAAAAADgPwAAAAAAAOA/AAAAAAAA4D8AAAAAAADgPwAAAAAAAOA/AAAAAAAA4D8CAAAAjAAAAAAAAAAAAAAAQoX0DP///wgAAAAAAAAAAAAAAAAAAAAAAAAAAAAAAAAAAAAAZAAAAAEAAABAAAAAAAAAAAAAAAAAAAAAAAAAAAAAAAAAAAAAAAAAAAAAAAAAAAAAAAAAAAAAAAAAAAAAAAAAAAAAAAAAAAAAAAAAAAAAAAAAAAAAAAAAAAAAAAAAAAAAFAAAADwAAAAAAAAAAAAAAAAAAAkUAAAAAQAAABQAAAAUAAAAFAAAAAEAAAAAAAAAZAAAAGQAAAAAAAAAZAAAAGQAAAAVAAAAYAAAAAAAAAAAAAAADwAAACADAAAAAAAAAAAAAAEAAACgMgAAVgcAAKr4//8BAAAAf39/AAEAAABkAAAAAAAAABQAAABAHwAAAAAAACYAAAAAAAAAwOD//wAAAAAmAAAAZAAAABYAAABMAAAAAAAAAAAAAAAEAAAAAAAAAAEAAABZWVkKAAAAACgAAAAoAAAAZAAAAGQAAAAAAAAAzMzMAAAAAABQAAAAUAAAAGQAAABkAAAAAAAAABcAAAAUAAAAAAAAAAAAAAD/fwAA/38AAAAAAAAJAAAABAAAAPDbzXceAAAAaAAAAAAAAAAAAAAAAAAAAAAAAAAAAAAAECcAABAnAAAAAAAAAAAAAAAAAAAAAAAAAAAAAAAAAAAAAAAAAAAAABQAAAAAAAAAwMD/AAAAAABkAAAAMgAAAAAAAABkAAAAAAAAAH9/fwAKAAAAIgAAABgAAAAAAAAAAAAAAAAAAAAAAAAAAAAAAAAAAAAkAAAAJAAAAAAAAAAHAAAAAAAAAAAAAAAAAAAAAAAAAAAAAAAAAAAAf39/ACUAAABYAAAAAAAAAAAAAAAAAAAAAAAAAAAAAAAAAAAAAAAAAAAAAAAAAAAAAAAAAAAAAAA/AAAAAAAAAKCGAQAAAAAAAAAAAAAAAAAMAAAAAQAAAAAAAAAAAAAAAAAAAB8AAABUAAAAAAAABQAAAAEAAAAAAAAAAAAAAAAAAAAAAAAAAAAAAAAAAAAAAAAAAAAAAAJ/f38AAAAAA8zMzADAwP8Af39/AAAAAAAAAAAAAAAAAAAAAAAAAAAAIQAAABgAAAAUAAAAOAQAALgaAAD4JQAACDQAABAAAAAmAAAACAAAAL0/AAAAAAAA"/>
               </a:ext>
             </a:extLst>
           </p:cNvSpPr>
@@ -2041,7 +2041,7 @@
           <p:cNvPicPr>
             <a:extLst>
               <a:ext uri="smNativeData">
-                <pr:smNativeData xmlns:pr="smNativeData" xmlns="smNativeData" val="SMDATA_17_FUV5ZhMAAAAlAAAAEQAAAA0AAAAAkAAAAEgAAACQAAAASAAAAAAAAAAAAAAAAAAAAAEAAABQAAAAAAAAAAAA4D8AAAAAAADgPwAAAAAAAOA/AAAAAAAA4D8AAAAAAADgPwAAAAAAAOA/AAAAAAAA4D8AAAAAAADgPwAAAAAAAOA/AAAAAAAA4D8CAAAAjAAAAAAAAAAAAAAAQoX0DP///wgAAAAAAAAAAAAAAAAAAAAAAAAAAAAAAAAAAAAAZAAAAAEAAABAAAAAAAAAAAAAAAAAAAAAAAAAAAAAAAAAAAAAAAAAAAAAAAAAAAAAAAAAAAAAAAAAAAAAAAAAAAAAAAAAAAAAAAAAAAAAAAAAAAAAAAAAAAAAAAAAAAAAFAAAADwAAAAAAAAAAAAAAAAAAAkUAAAAAQAAABQAAAAUAAAAFAAAAAEAAAAAAAAAZAAAAGQAAAAAAAAAZAAAAGQAAAAVAAAAYAAAAAAAAAAAAAAADwAAACADAAAAAAAAAAAAAAEAAACgMgAAVgcAAKr4//8BAAAAf39/AAEAAABkAAAAAAAAABQAAABAHwAAAAAAACYAAAAAAAAAwOD//wAAAAAmAAAAZAAAABYAAABMAAAAAAAAAAAAAAAEAAAAAAAAAAEAAABZWVkKAAAAACgAAAAoAAAAZAAAAGQAAAAAAAAAzMzMAAAAAABQAAAAUAAAAGQAAABkAAAAAAAAAAcAAAA4AAAAAAAAAAAAAAAAAAAA////AAAAAAAAAAAAAAAAAAAAAAAAAAAAAAAAAAAAAABkAAAAZAAAAAAAAAAjAAAABAAAAGQAAAAXAAAAFAAAAAAAAAAAAAAA/38AAP9/AAAAAAAACQAAAAQAAAAlAwAAHgAAAGgAAAAAAAAAAAAAAAAAAAAAAAAAAAAAABAnAAAQJwAAAAAAAAAAAAAAAAAAAAAAAAAAAAAAAAAAAAAAAAAAAAAUAAAAAAAAAMDA/wAAAAAAZAAAADIAAAAAAAAAZAAAAAAAAAB/f38ACgAAACIAAAAYAAAAAAAAAAAAAAAAAAAAAAAAAAAAAAAAAAAAJAAAACQAAAAAAAAABwAAAAAAAAAAAAAAAAAAAAAAAAAAAAAAAAAAAH9/fwAlAAAAWAAAAAAAAAAAAAAAAAAAAAAAAAAAAAAAAAAAAAAAAAAAAAAAAAAAAAAAAAAAAAAAPwAAAAAAAACghgEAAAAAAAAAAAAAAAAADAAAAAEAAAAAAAAAAAAAAAAAAAAfAAAAVAAAAEKF9AX///8BAAAAAAAAAAAAAAAAAAAAAAAAAAAAAAAAAAAAAAAAAAAAAAACf39/AFlZWQPMzMwAwMD/AH9/fwAAAAAAAAAAAAAAAAD///8AAAAAACEAAAAYAAAAFAAAAOT////r////XDgAAEUqAAAQAAAAJgAAAAgAAAD//////////w=="/>
+                <pr:smNativeData xmlns:pr="smNativeData" xmlns="smNativeData" val="SMDATA_17_9kV5ZhMAAAAlAAAAEQAAAA0AAAAAkAAAAEgAAACQAAAASAAAAAAAAAAAAAAAAAAAAAEAAABQAAAAAAAAAAAA4D8AAAAAAADgPwAAAAAAAOA/AAAAAAAA4D8AAAAAAADgPwAAAAAAAOA/AAAAAAAA4D8AAAAAAADgPwAAAAAAAOA/AAAAAAAA4D8CAAAAjAAAAAAAAAAAAAAAQoX0DP///wgAAAAAAAAAAAAAAAAAAAAAAAAAAAAAAAAAAAAAZAAAAAEAAABAAAAAAAAAAAAAAAAAAAAAAAAAAAAAAAAAAAAAAAAAAAAAAAAAAAAAAAAAAAAAAAAAAAAAAAAAAAAAAAAAAAAAAAAAAAAAAAAAAAAAAAAAAAAAAAAAAAAAFAAAADwAAAAAAAAAAAAAAAAAAAkUAAAAAQAAABQAAAAUAAAAFAAAAAEAAAAAAAAAZAAAAGQAAAAAAAAAZAAAAGQAAAAVAAAAYAAAAAAAAAAAAAAADwAAACADAAAAAAAAAAAAAAEAAACgMgAAVgcAAKr4//8BAAAAf39/AAEAAABkAAAAAAAAABQAAABAHwAAAAAAACYAAAAAAAAAwOD//wAAAAAmAAAAZAAAABYAAABMAAAAAAAAAAAAAAAEAAAAAAAAAAEAAABZWVkKAAAAACgAAAAoAAAAZAAAAGQAAAAAAAAAzMzMAAAAAABQAAAAUAAAAGQAAABkAAAAAAAAAAcAAAA4AAAAAAAAAAAAAAAAAAAA////AAAAAAAAAAAAAAAAAAAAAAAAAAAAAAAAAAAAAABkAAAAZAAAAAAAAAAjAAAABAAAAGQAAAAXAAAAFAAAAAAAAAAAAAAA/38AAP9/AAAAAAAACQAAAAQAAAAlAwAAHgAAAGgAAAAAAAAAAAAAAAAAAAAAAAAAAAAAABAnAAAQJwAAAAAAAAAAAAAAAAAAAAAAAAAAAAAAAAAAAAAAAAAAAAAUAAAAAAAAAMDA/wAAAAAAZAAAADIAAAAAAAAAZAAAAAAAAAB/f38ACgAAACIAAAAYAAAAAAAAAAAAAAAAAAAAAAAAAAAAAAAAAAAAJAAAACQAAAAAAAAABwAAAAAAAAAAAAAAAAAAAAAAAAAAAAAAAAAAAH9/fwAlAAAAWAAAAAAAAAAAAAAAAAAAAAAAAAAAAAAAAAAAAAAAAAAAAAAAAAAAAAAAAAAAAAAAPwAAAAAAAACghgEAAAAAAAAAAAAAAAAADAAAAAEAAAAAAAAAAAAAAAAAAAAfAAAAVAAAAEKF9AX///8BAAAAAAAAAAAAAAAAAAAAAAAAAAAAAAAAAAAAAAAAAAAAAAACf39/AFlZWQPMzMwAwMD/AH9/fwAAAAAAAAAAAAAAAAD///8AAAAAACEAAAAYAAAAFAAAAOT////r////XDgAAEUqAAAQAAAAJgAAAAgAAAD//////////w=="/>
               </a:ext>
             </a:extLst>
           </p:cNvPicPr>
@@ -2075,7 +2075,7 @@
             <a:spLocks noGrp="1" noChangeArrowheads="1"/>
             <a:extLst>
               <a:ext uri="smNativeData">
-                <pr:smNativeData xmlns:pr="smNativeData" xmlns="smNativeData" val="SMDATA_15_FUV5ZhMAAAAlAAAAZAAAAA0AAAAAkAAAAJAAAACQAAAAkAAAAAAAAAAAAAAAAAAAAAEAAABQAAAAAAAAAAAA4D8AAAAAAADgPwAAAAAAAOA/AAAAAAAA4D8AAAAAAADgPwAAAAAAAOA/AAAAAAAA4D8AAAAAAADgPwAAAAAAAOA/AAAAAAAA4D8CAAAAjAAAAAAAAAAAAAAAQoX0DP///wgAAAAAAAAAAAAAAAAAAAAAAAAAAAAAAAAAAAAAZAAAAAEAAABAAAAAAAAAAAAAAAAAAAAAAAAAAAAAAAAAAAAAAAAAAAAAAAAAAAAAAAAAAAAAAAAAAAAAAAAAAAAAAAAAAAAAAAAAAAAAAAAAAAAAAAAAAAAAAAAAAAAAFAAAADwAAAAAAAAAAAAAAAAAAAkUAAAAAQAAABQAAAAUAAAAFAAAAAEAAAAAAAAAZAAAAGQAAAAAAAAAZAAAAGQAAAAVAAAAYAAAAAAAAAAAAAAADwAAACADAAAAAAAAAAAAAAEAAACgMgAAVgcAAKr4//8BAAAAf39/AAEAAABkAAAAAAAAABQAAABAHwAAAAAAACYAAAAAAAAAwOD//wAAAAAmAAAAZAAAABYAAABMAAAAAAAAAAAAAAAEAAAAAAAAAAEAAABZWVkKAAAAACgAAAAoAAAAZAAAAGQAAAAAAAAAzMzMAAAAAABQAAAAUAAAAGQAAABkAAAAAAAAABcAAAAUAAAAAAAAAAAAAAD/fwAA/38AAAAAAAAJAAAABAAAAAAAAAAeAAAAaAAAAAAAAAAAAAAAAAAAAAAAAAAAAAAAECcAABAnAAAAAAAAAAAAAAAAAAAAAAAAAAAAAAAAAAAAAAAAAAAAABQAAAAAAAAAwMD/AAAAAABkAAAAMgAAAAAAAABkAAAAAAAAAH9/fwAKAAAAIgAAABgAAAAAAAAAAAAAAAAAAAAAAAAAAAAAAAAAAAAkAAAAJAAAAAAAAAAHAAAAAAAAAAAAAAAAAAAAAAAAAAAAAAAAAAAAf39/ACUAAABYAAAAAAAAAAAAAAAAAAAAAAAAAAAAAAAAAAAAAAAAAAAAAAAAAAAAAAAAAAAAAAA/AAAAAAAAAKCGAQAAAAAAAAAAAAAAAAAMAAAAAQAAAAAAAAAAAAAAAAAAAB8AAABUAAAAAAAABQAAAAEAAAAAAAAAAAAAAAAAAAAAAAAAAAAAAAAAAAAAAAAAAAAAAAJ/f38AAAAAA8zMzADAwP8Af39/AAAAAAAAAAAAAAAAAAAAAAAAAAAAIQAAABgAAAAUAAAA5wQAAD8jAAD6IwAAvykAABAAAAAmAAAACAAAAD2wAAAAAAAA"/>
+                <pr:smNativeData xmlns:pr="smNativeData" xmlns="smNativeData" val="SMDATA_15_9kV5ZhMAAAAlAAAAZAAAAA0AAAAAkAAAAJAAAACQAAAAkAAAAAAAAAAAAAAAAAAAAAEAAABQAAAAAAAAAAAA4D8AAAAAAADgPwAAAAAAAOA/AAAAAAAA4D8AAAAAAADgPwAAAAAAAOA/AAAAAAAA4D8AAAAAAADgPwAAAAAAAOA/AAAAAAAA4D8CAAAAjAAAAAAAAAAAAAAAQoX0DP///wgAAAAAAAAAAAAAAAAAAAAAAAAAAAAAAAAAAAAAZAAAAAEAAABAAAAAAAAAAAAAAAAAAAAAAAAAAAAAAAAAAAAAAAAAAAAAAAAAAAAAAAAAAAAAAAAAAAAAAAAAAAAAAAAAAAAAAAAAAAAAAAAAAAAAAAAAAAAAAAAAAAAAFAAAADwAAAAAAAAAAAAAAAAAAAkUAAAAAQAAABQAAAAUAAAAFAAAAAEAAAAAAAAAZAAAAGQAAAAAAAAAZAAAAGQAAAAVAAAAYAAAAAAAAAAAAAAADwAAACADAAAAAAAAAAAAAAEAAACgMgAAVgcAAKr4//8BAAAAf39/AAEAAABkAAAAAAAAABQAAABAHwAAAAAAACYAAAAAAAAAwOD//wAAAAAmAAAAZAAAABYAAABMAAAAAAAAAAAAAAAEAAAAAAAAAAEAAABZWVkKAAAAACgAAAAoAAAAZAAAAGQAAAAAAAAAzMzMAAAAAABQAAAAUAAAAGQAAABkAAAAAAAAABcAAAAUAAAAAAAAAAAAAAD/fwAA/38AAAAAAAAJAAAABAAAAAAAAAAeAAAAaAAAAAAAAAAAAAAAAAAAAAAAAAAAAAAAECcAABAnAAAAAAAAAAAAAAAAAAAAAAAAAAAAAAAAAAAAAAAAAAAAABQAAAAAAAAAwMD/AAAAAABkAAAAMgAAAAAAAABkAAAAAAAAAH9/fwAKAAAAIgAAABgAAAAAAAAAAAAAAAAAAAAAAAAAAAAAAAAAAAAkAAAAJAAAAAAAAAAHAAAAAAAAAAAAAAAAAAAAAAAAAAAAAAAAAAAAf39/ACUAAABYAAAAAAAAAAAAAAAAAAAAAAAAAAAAAAAAAAAAAAAAAAAAAAAAAAAAAAAAAAAAAAA/AAAAAAAAAKCGAQAAAAAAAAAAAAAAAAAMAAAAAQAAAAAAAAAAAAAAAAAAAB8AAABUAAAAAAAABQAAAAEAAAAAAAAAAAAAAAAAAAAAAAAAAAAAAAAAAAAAAAAAAAAAAAJ/f38AAAAAA8zMzADAwP8Af39/AAAAAAAAAAAAAAAAAAAAAAAAAAAAIQAAABgAAAAUAAAA5wQAAD8jAAD6IwAAvykAABAAAAAmAAAACAAAAD2wAAAAAAAA"/>
               </a:ext>
             </a:extLst>
           </p:cNvSpPr>
@@ -2230,7 +2230,7 @@
             <a:spLocks noGrp="1" noChangeArrowheads="1"/>
             <a:extLst>
               <a:ext uri="smNativeData">
-                <pr:smNativeData xmlns:pr="smNativeData" xmlns="smNativeData" val="SMDATA_15_FUV5ZhMAAAAlAAAAZAAAAA0AAAAAkAAAAJAAAACQAAAAkAAAAAAAAAAAAAAAAAAAAAEAAABQAAAAAAAAAAAA4D8AAAAAAADgPwAAAAAAAOA/AAAAAAAA4D8AAAAAAADgPwAAAAAAAOA/AAAAAAAA4D8AAAAAAADgPwAAAAAAAOA/AAAAAAAA4D8CAAAAjAAAAAAAAAAAAAAAQoX0DP///wgAAAAAAAAAAAAAAAAAAAAAAAAAAAAAAAAAAAAAZAAAAAEAAABAAAAAAAAAAAAAAAAAAAAAAAAAAAAAAAAAAAAAAAAAAAAAAAAAAAAAAAAAAAAAAAAAAAAAAAAAAAAAAAAAAAAAAAAAAAAAAAAAAAAAAAAAAAAAAAAAAAAAFAAAADwAAAAAAAAAAAAAAAAAAAkUAAAAAQAAABQAAAAUAAAAFAAAAAEAAAAAAAAAZAAAAGQAAAAAAAAAZAAAAGQAAAAVAAAAYAAAAAAAAAAAAAAADwAAACADAAAAAAAAAAAAAAEAAACgMgAAVgcAAKr4//8BAAAAf39/AAEAAABkAAAAAAAAABQAAABAHwAAAAAAACYAAAAAAAAAwOD//wAAAAAmAAAAZAAAABYAAABMAAAAAAAAAAAAAAAEAAAAAAAAAAEAAABZWVkKAAAAACgAAAAoAAAAZAAAAGQAAAAAAAAAzMzMAAAAAABQAAAAUAAAAGQAAABkAAAAAAAAABcAAAAUAAAAAAAAAAAAAAD/fwAA/38AAAAAAAAJAAAABAAAAAAAAAAeAAAAaAAAAAAAAAAAAAAAAAAAAAAAAAAAAAAAECcAABAnAAAAAAAAAAAAAAAAAAAAAAAAAAAAAAAAAAAAAAAAAAAAABQAAAAAAAAAwMD/AAAAAABkAAAAMgAAAAAAAABkAAAAAAAAAH9/fwAKAAAAIgAAABgAAAAAAAAAAAAAAAAAAAAAAAAAAAAAAAAAAAAkAAAAJAAAAAAAAAAHAAAAAAAAAAAAAAAAAAAAAAAAAAAAAAAAAAAAf39/ACUAAABYAAAAAAAAAAAAAAAAAAAAAAAAAAAAAAAAAAAAAAAAAAAAAAAAAAAAAAAAAAAAAAA/AAAAAAAAAKCGAQAAAAAAAAAAAAAAAAAMAAAAAQAAAAAAAAAAAAAAAAAAAB8AAABUAAAAAAAABQAAAAEAAAAAAAAAAAAAAAAAAAAAAAAAAAAAAAAAAAAAAAAAAAAAAAJ/f38AAAAAA8zMzADAwP8Af39/AAAAAAAAAAAAAAAAAAAAAAAAAAAAIQAAABgAAAAUAAAA5wQAAMMPAACROAAAfyQAABAAAAAmAAAACAAAAD2wAAAAAAAA"/>
+                <pr:smNativeData xmlns:pr="smNativeData" xmlns="smNativeData" val="SMDATA_15_9kV5ZhMAAAAlAAAAZAAAAA0AAAAAkAAAAJAAAACQAAAAkAAAAAAAAAAAAAAAAAAAAAEAAABQAAAAAAAAAAAA4D8AAAAAAADgPwAAAAAAAOA/AAAAAAAA4D8AAAAAAADgPwAAAAAAAOA/AAAAAAAA4D8AAAAAAADgPwAAAAAAAOA/AAAAAAAA4D8CAAAAjAAAAAAAAAAAAAAAQoX0DP///wgAAAAAAAAAAAAAAAAAAAAAAAAAAAAAAAAAAAAAZAAAAAEAAABAAAAAAAAAAAAAAAAAAAAAAAAAAAAAAAAAAAAAAAAAAAAAAAAAAAAAAAAAAAAAAAAAAAAAAAAAAAAAAAAAAAAAAAAAAAAAAAAAAAAAAAAAAAAAAAAAAAAAFAAAADwAAAAAAAAAAAAAAAAAAAkUAAAAAQAAABQAAAAUAAAAFAAAAAEAAAAAAAAAZAAAAGQAAAAAAAAAZAAAAGQAAAAVAAAAYAAAAAAAAAAAAAAADwAAACADAAAAAAAAAAAAAAEAAACgMgAAVgcAAKr4//8BAAAAf39/AAEAAABkAAAAAAAAABQAAABAHwAAAAAAACYAAAAAAAAAwOD//wAAAAAmAAAAZAAAABYAAABMAAAAAAAAAAAAAAAEAAAAAAAAAAEAAABZWVkKAAAAACgAAAAoAAAAZAAAAGQAAAAAAAAAzMzMAAAAAABQAAAAUAAAAGQAAABkAAAAAAAAABcAAAAUAAAAAAAAAAAAAAD/fwAA/38AAAAAAAAJAAAABAAAAAAAAAAeAAAAaAAAAAAAAAAAAAAAAAAAAAAAAAAAAAAAECcAABAnAAAAAAAAAAAAAAAAAAAAAAAAAAAAAAAAAAAAAAAAAAAAABQAAAAAAAAAwMD/AAAAAABkAAAAMgAAAAAAAABkAAAAAAAAAH9/fwAKAAAAIgAAABgAAAAAAAAAAAAAAAAAAAAAAAAAAAAAAAAAAAAkAAAAJAAAAAAAAAAHAAAAAAAAAAAAAAAAAAAAAAAAAAAAAAAAAAAAf39/ACUAAABYAAAAAAAAAAAAAAAAAAAAAAAAAAAAAAAAAAAAAAAAAAAAAAAAAAAAAAAAAAAAAAA/AAAAAAAAAKCGAQAAAAAAAAAAAAAAAAAMAAAAAQAAAAAAAAAAAAAAAAAAAB8AAABUAAAAAAAABQAAAAEAAAAAAAAAAAAAAAAAAAAAAAAAAAAAAAAAAAAAAAAAAAAAAAJ/f38AAAAAA8zMzADAwP8Af39/AAAAAAAAAAAAAAAAAAAAAAAAAAAAIQAAABgAAAAUAAAA5wQAAMMPAACROAAAfyQAABAAAAAmAAAACAAAAD2wAAAAAAAA"/>
               </a:ext>
             </a:extLst>
           </p:cNvSpPr>
@@ -2410,7 +2410,7 @@
             <a:spLocks noGrp="1" noChangeArrowheads="1"/>
             <a:extLst>
               <a:ext uri="smNativeData">
-                <pr:smNativeData xmlns:pr="smNativeData" xmlns="smNativeData" val="SMDATA_15_FUV5ZhMAAAAlAAAAZAAAAA0AAAAAkAAAAJAAAACQAAAAkAAAAAAAAAAAAAAAAAAAAAEAAABQAAAAAAAAAAAA4D8AAAAAAADgPwAAAAAAAOA/AAAAAAAA4D8AAAAAAADgPwAAAAAAAOA/AAAAAAAA4D8AAAAAAADgPwAAAAAAAOA/AAAAAAAA4D8CAAAAjAAAAAAAAAAAAAAAQoX0DP///wgAAAAAAAAAAAAAAAAAAAAAAAAAAAAAAAAAAAAAZAAAAAEAAABAAAAAAAAAAAAAAAAAAAAAAAAAAAAAAAAAAAAAAAAAAAAAAAAAAAAAAAAAAAAAAAAAAAAAAAAAAAAAAAAAAAAAAAAAAAAAAAAAAAAAAAAAAAAAAAAAAAAAFAAAADwAAAAAAAAAAAAAAAAAAAkUAAAAAQAAABQAAAAUAAAAFAAAAAEAAAAAAAAAZAAAAGQAAAAAAAAAZAAAAGQAAAAVAAAAYAAAAAAAAAAAAAAADwAAACADAAAAAAAAAAAAAAEAAACgMgAAVgcAAKr4//8BAAAAf39/AAEAAABkAAAAAAAAABQAAABAHwAAAAAAACYAAAAAAAAAwOD//wAAAAAmAAAAZAAAABYAAABMAAAAAAAAAAAAAAAEAAAAAAAAAAEAAABZWVkKAAAAACgAAAAoAAAAZAAAAGQAAAAAAAAAzMzMAAAAAABQAAAAUAAAAGQAAABkAAAAAAAAABcAAAAUAAAAAAAAAAAAAAD/fwAA/38AAAAAAAAJAAAABAAAAAAAAAAeAAAAaAAAAAAAAAAAAAAAAAAAAAAAAAAAAAAAECcAABAnAAAAAAAAAAAAAAAAAAAAAAAAAAAAAAAAAAAAAAAAAAAAABQAAAAAAAAAwMD/AAAAAABkAAAAMgAAAAAAAABkAAAAAAAAAH9/fwAKAAAAIgAAABgAAAAAAAAAAAAAAAAAAAAAAAAAAAAAAAAAAAAkAAAAJAAAAAAAAAAHAAAAAAAAAAAAAAAAAAAAAAAAAAAAAAAAAAAAf39/ACUAAABYAAAAAAAAAAAAAAAAAAAAAAAAAAAAAAAAAAAAAAAAAAAAAAAAAAAAAAAAAAAAAAA/AAAAAAAAAKCGAQAAAAAAAAAAAAAAAAAMAAAAAQAAAAAAAAAAAAAAAAAAAB8AAABUAAAAAAAABQAAAAEAAAAAAAAAAAAAAAAAAAAAAAAAAAAAAAAAAAAAAAAAAAAAAAJ/f38AAAAAA8zMzADAwP8Af39/AAAAAAAAAAAAAAAAAAAAAAAAAAAAIQAAABgAAAAUAAAAFAMAALYCAAB/NwAAvwoAABAAAAAmAAAACAAAADywAAAAAAAA"/>
+                <pr:smNativeData xmlns:pr="smNativeData" xmlns="smNativeData" val="SMDATA_15_9kV5ZhMAAAAlAAAAZAAAAA0AAAAAkAAAAJAAAACQAAAAkAAAAAAAAAAAAAAAAAAAAAEAAABQAAAAAAAAAAAA4D8AAAAAAADgPwAAAAAAAOA/AAAAAAAA4D8AAAAAAADgPwAAAAAAAOA/AAAAAAAA4D8AAAAAAADgPwAAAAAAAOA/AAAAAAAA4D8CAAAAjAAAAAAAAAAAAAAAQoX0DP///wgAAAAAAAAAAAAAAAAAAAAAAAAAAAAAAAAAAAAAZAAAAAEAAABAAAAAAAAAAAAAAAAAAAAAAAAAAAAAAAAAAAAAAAAAAAAAAAAAAAAAAAAAAAAAAAAAAAAAAAAAAAAAAAAAAAAAAAAAAAAAAAAAAAAAAAAAAAAAAAAAAAAAFAAAADwAAAAAAAAAAAAAAAAAAAkUAAAAAQAAABQAAAAUAAAAFAAAAAEAAAAAAAAAZAAAAGQAAAAAAAAAZAAAAGQAAAAVAAAAYAAAAAAAAAAAAAAADwAAACADAAAAAAAAAAAAAAEAAACgMgAAVgcAAKr4//8BAAAAf39/AAEAAABkAAAAAAAAABQAAABAHwAAAAAAACYAAAAAAAAAwOD//wAAAAAmAAAAZAAAABYAAABMAAAAAAAAAAAAAAAEAAAAAAAAAAEAAABZWVkKAAAAACgAAAAoAAAAZAAAAGQAAAAAAAAAzMzMAAAAAABQAAAAUAAAAGQAAABkAAAAAAAAABcAAAAUAAAAAAAAAAAAAAD/fwAA/38AAAAAAAAJAAAABAAAAAAAAAAeAAAAaAAAAAAAAAAAAAAAAAAAAAAAAAAAAAAAECcAABAnAAAAAAAAAAAAAAAAAAAAAAAAAAAAAAAAAAAAAAAAAAAAABQAAAAAAAAAwMD/AAAAAABkAAAAMgAAAAAAAABkAAAAAAAAAH9/fwAKAAAAIgAAABgAAAAAAAAAAAAAAAAAAAAAAAAAAAAAAAAAAAAkAAAAJAAAAAAAAAAHAAAAAAAAAAAAAAAAAAAAAAAAAAAAAAAAAAAAf39/ACUAAABYAAAAAAAAAAAAAAAAAAAAAAAAAAAAAAAAAAAAAAAAAAAAAAAAAAAAAAAAAAAAAAA/AAAAAAAAAKCGAQAAAAAAAAAAAAAAAAAMAAAAAQAAAAAAAAAAAAAAAAAAAB8AAABUAAAAAAAABQAAAAEAAAAAAAAAAAAAAAAAAAAAAAAAAAAAAAAAAAAAAAAAAAAAAAJ/f38AAAAAA8zMzADAwP8Af39/AAAAAAAAAAAAAAAAAAAAAAAAAAAAIQAAABgAAAAUAAAAFAMAALYCAAB/NwAAvwoAABAAAAAmAAAACAAAADywAAAAAAAA"/>
               </a:ext>
             </a:extLst>
           </p:cNvSpPr>
@@ -2545,7 +2545,7 @@
             <a:spLocks noGrp="1" noChangeArrowheads="1"/>
             <a:extLst>
               <a:ext uri="smNativeData">
-                <pr:smNativeData xmlns:pr="smNativeData" xmlns="smNativeData" val="SMDATA_15_FUV5ZhMAAAAlAAAAZAAAAA0AAAAAkAAAAJAAAACQAAAAkAAAAAAAAAAAAAAAAAAAAAEAAABQAAAAAAAAAAAA4D8AAAAAAADgPwAAAAAAAOA/AAAAAAAA4D8AAAAAAADgPwAAAAAAAOA/AAAAAAAA4D8AAAAAAADgPwAAAAAAAOA/AAAAAAAA4D8CAAAAjAAAAAAAAAAAAAAAQoX0DP///wgAAAAAAAAAAAAAAAAAAAAAAAAAAAAAAAAAAAAAZAAAAAEAAABAAAAAAAAAAAAAAAAAAAAAAAAAAAAAAAAAAAAAAAAAAAAAAAAAAAAAAAAAAAAAAAAAAAAAAAAAAAAAAAAAAAAAAAAAAAAAAAAAAAAAAAAAAAAAAAAAAAAAFAAAADwAAAAAAAAAAAAAAAAAAAkUAAAAAQAAABQAAAAUAAAAFAAAAAEAAAAAAAAAZAAAAGQAAAAAAAAAZAAAAGQAAAAVAAAAYAAAAAAAAAAAAAAADwAAACADAAAAAAAAAAAAAAEAAACgMgAAVgcAAKr4//8BAAAAf39/AAEAAABkAAAAAAAAABQAAABAHwAAAAAAACYAAAAAAAAAwOD//wAAAAAmAAAAZAAAABYAAABMAAAAAAAAAAAAAAAEAAAAAAAAAAEAAABZWVkKAAAAACgAAAAoAAAAZAAAAGQAAAAAAAAAzMzMAAAAAABQAAAAUAAAAGQAAABkAAAAAAAAABcAAAAUAAAAAAAAAAAAAAD/fwAA/38AAAAAAAAJAAAABAAAAAAAAAAeAAAAaAAAAAAAAAAAAAAAAAAAAAAAAAAAAAAAECcAABAnAAAAAAAAAAAAAAAAAAAAAAAAAAAAAAAAAAAAAAAAAAAAABQAAAAAAAAAwMD/AAAAAABkAAAAMgAAAAAAAABkAAAAAAAAAH9/fwAKAAAAIgAAABgAAAAAAAAAAAAAAAAAAAAAAAAAAAAAAAAAAAAkAAAAJAAAAAAAAAAHAAAAAAAAAAAAAAAAAAAAAAAAAAAAAAAAAAAAf39/ACUAAABYAAAAAAAAAAAAAAAAAAAAAAAAAAAAAAAAAAAAAAAAAAAAAAAAAAAAAAAAAAAAAAA/AAAAAAAAAKCGAQAAAAAAAAAAAAAAAAAMAAAAAQAAAAAAAAAAAAAAAAAAAB8AAABUAAAAAAAABQAAAAEAAAAAAAAAAAAAAAAAAAAAAAAAAAAAAAAAAAAAAAAAAAAAAAJ/f38AAAAAA8zMzADAwP8Af39/AAAAAAAAAAAAAAAAAAAAAAAAAAAAIQAAABgAAAAUAAAAFAMAALYCAAB/NwAAvwoAABAAAAAmAAAACAAAADywAAAAAAAA"/>
+                <pr:smNativeData xmlns:pr="smNativeData" xmlns="smNativeData" val="SMDATA_15_9kV5ZhMAAAAlAAAAZAAAAA0AAAAAkAAAAJAAAACQAAAAkAAAAAAAAAAAAAAAAAAAAAEAAABQAAAAAAAAAAAA4D8AAAAAAADgPwAAAAAAAOA/AAAAAAAA4D8AAAAAAADgPwAAAAAAAOA/AAAAAAAA4D8AAAAAAADgPwAAAAAAAOA/AAAAAAAA4D8CAAAAjAAAAAAAAAAAAAAAQoX0DP///wgAAAAAAAAAAAAAAAAAAAAAAAAAAAAAAAAAAAAAZAAAAAEAAABAAAAAAAAAAAAAAAAAAAAAAAAAAAAAAAAAAAAAAAAAAAAAAAAAAAAAAAAAAAAAAAAAAAAAAAAAAAAAAAAAAAAAAAAAAAAAAAAAAAAAAAAAAAAAAAAAAAAAFAAAADwAAAAAAAAAAAAAAAAAAAkUAAAAAQAAABQAAAAUAAAAFAAAAAEAAAAAAAAAZAAAAGQAAAAAAAAAZAAAAGQAAAAVAAAAYAAAAAAAAAAAAAAADwAAACADAAAAAAAAAAAAAAEAAACgMgAAVgcAAKr4//8BAAAAf39/AAEAAABkAAAAAAAAABQAAABAHwAAAAAAACYAAAAAAAAAwOD//wAAAAAmAAAAZAAAABYAAABMAAAAAAAAAAAAAAAEAAAAAAAAAAEAAABZWVkKAAAAACgAAAAoAAAAZAAAAGQAAAAAAAAAzMzMAAAAAABQAAAAUAAAAGQAAABkAAAAAAAAABcAAAAUAAAAAAAAAAAAAAD/fwAA/38AAAAAAAAJAAAABAAAAAAAAAAeAAAAaAAAAAAAAAAAAAAAAAAAAAAAAAAAAAAAECcAABAnAAAAAAAAAAAAAAAAAAAAAAAAAAAAAAAAAAAAAAAAAAAAABQAAAAAAAAAwMD/AAAAAABkAAAAMgAAAAAAAABkAAAAAAAAAH9/fwAKAAAAIgAAABgAAAAAAAAAAAAAAAAAAAAAAAAAAAAAAAAAAAAkAAAAJAAAAAAAAAAHAAAAAAAAAAAAAAAAAAAAAAAAAAAAAAAAAAAAf39/ACUAAABYAAAAAAAAAAAAAAAAAAAAAAAAAAAAAAAAAAAAAAAAAAAAAAAAAAAAAAAAAAAAAAA/AAAAAAAAAKCGAQAAAAAAAAAAAAAAAAAMAAAAAQAAAAAAAAAAAAAAAAAAAB8AAABUAAAAAAAABQAAAAEAAAAAAAAAAAAAAAAAAAAAAAAAAAAAAAAAAAAAAAAAAAAAAAJ/f38AAAAAA8zMzADAwP8Af39/AAAAAAAAAAAAAAAAAAAAAAAAAAAAIQAAABgAAAAUAAAAFAMAALYCAAB/NwAAvwoAABAAAAAmAAAACAAAADywAAAAAAAA"/>
               </a:ext>
             </a:extLst>
           </p:cNvSpPr>
@@ -2654,7 +2654,7 @@
           <p:cNvSpPr>
             <a:extLst>
               <a:ext uri="smNativeData">
-                <pr:smNativeData xmlns:pr="smNativeData" xmlns="smNativeData" val="SMDATA_15_FUV5ZhMAAAAlAAAAZAAAAA0AAAAAkAAAAJAAAACQAAAAkAAAAAAAAAABAAAAAAAAAAEAAABQAAAAAAAAAAAA4D8AAAAAAADgPwAAAAAAAOA/AAAAAAAA4D8AAAAAAADgPwAAAAAAAOA/AAAAAAAA4D8AAAAAAADgPwAAAAAAAOA/AAAAAAAA4D8CAAAAjAAAAAEAAAAAAAAA+/v+AP///wgAAAAAAAAAAAAAAAAAAAAAAAAAAAAAAAAAAAAAeAAAAAEAAABAAAAAAAAAAAAAAABaAAAAAAAAAAAAAAAAAAAAAAAAAAAAAAAAAAAAAAAAAAAAAAAAAAAAAAAAAAAAAAAAAAAAAAAAAAAAAAAAAAAAAAAAAAAAAAAAAAAAFAAAADwAAAAAAAAAAAAAAAAAAAkUAAAAAQAAABQAAAAUAAAAFAAAAAEAAAAAAAAAZAAAAGQAAAAAAAAAZAAAAGQAAAAVAAAAYAAAAAAAAAAAAAAADwAAACADAAAAAAAAAAAAAAEAAACgMgAAVgcAAKr4//8BAAAAf39/AAEAAABkAAAAAAAAABQAAABAHwAAAAAAACYAAAAAAAAAwOD//wAAAAAmAAAAZAAAABYAAABMAAAAAAAAAAAAAAAEAAAAAAAAAAEAAABZWVkKAAAAACgAAAAoAAAAZAAAAGQAAAAAAAAAzMzMAAAAAABQAAAAUAAAAGQAAABkAAAAAAAAABcAAAAUAAAAAAAAAAAAAAD/fwAA/38AAAAAAAAJAAAABAAAAAAAAAAeAAAAaAAAAAAAAAAAAAAAAAAAAAAAAAAAAAAAECcAABAnAAAAAAAAAAAAAAAAAAAAAAAAAAAAAAAAAAAAAAAAAAAAABQAAAAAAAAAwMD/AAAAAABkAAAAMgAAAAAAAABkAAAAAAAAAH9/fwAKAAAAIgAAABgAAAAAAAAAAAAAAAAAAAAAAAAAAAAAAAAAAAAkAAAAJAAAAAAAAAAHAAAAAAAAAAAAAAAAAAAAAAAAAAAAAAAAAAAAf39/ACUAAABYAAAAAAAAAAAAAAAAAAAAAAAAAAAAAAAAAAAAAAAAAAAAAAAAAAAAAAAAAAAAAAA/AAAAAAAAAKCGAQAAAAAAAAAAAAAAAAAMAAAAAQAAAAAAAAAAAAAAAAAAAB8AAABUAAAA+/v+AP///wEAAAAAAAAAAAAAAAAAAAAAAAAAAAAAAAAAAAAAAAAAAAAAAAJ/f38AWVlZA8zMzADAwP8Af39/AAAAAAAAAAAAAAAAAAAAAAAAAAAAIQAAABgAAAAUAAAAuwMAAPIJAACQNAAALycAABAAAAAmAAAACAAAAP//////////"/>
+                <pr:smNativeData xmlns:pr="smNativeData" xmlns="smNativeData" val="SMDATA_15_9kV5ZhMAAAAlAAAAZAAAAA0AAAAAkAAAAJAAAACQAAAAkAAAAAAAAAABAAAAAAAAAAEAAABQAAAAAAAAAAAA4D8AAAAAAADgPwAAAAAAAOA/AAAAAAAA4D8AAAAAAADgPwAAAAAAAOA/AAAAAAAA4D8AAAAAAADgPwAAAAAAAOA/AAAAAAAA4D8CAAAAjAAAAAEAAAAAAAAA+/v+AP///wgAAAAAAAAAAAAAAAAAAAAAAAAAAAAAAAAAAAAAeAAAAAEAAABAAAAAAAAAAAAAAABaAAAAAAAAAAAAAAAAAAAAAAAAAAAAAAAAAAAAAAAAAAAAAAAAAAAAAAAAAAAAAAAAAAAAAAAAAAAAAAAAAAAAAAAAAAAAAAAAAAAAFAAAADwAAAAAAAAAAAAAAAAAAAkUAAAAAQAAABQAAAAUAAAAFAAAAAEAAAAAAAAAZAAAAGQAAAAAAAAAZAAAAGQAAAAVAAAAYAAAAAAAAAAAAAAADwAAACADAAAAAAAAAAAAAAEAAACgMgAAVgcAAKr4//8BAAAAf39/AAEAAABkAAAAAAAAABQAAABAHwAAAAAAACYAAAAAAAAAwOD//wAAAAAmAAAAZAAAABYAAABMAAAAAAAAAAAAAAAEAAAAAAAAAAEAAABZWVkKAAAAACgAAAAoAAAAZAAAAGQAAAAAAAAAzMzMAAAAAABQAAAAUAAAAGQAAABkAAAAAAAAABcAAAAUAAAAAAAAAAAAAAD/fwAA/38AAAAAAAAJAAAABAAAAAAAAAAeAAAAaAAAAAAAAAAAAAAAAAAAAAAAAAAAAAAAECcAABAnAAAAAAAAAAAAAAAAAAAAAAAAAAAAAAAAAAAAAAAAAAAAABQAAAAAAAAAwMD/AAAAAABkAAAAMgAAAAAAAABkAAAAAAAAAH9/fwAKAAAAIgAAABgAAAAAAAAAAAAAAAAAAAAAAAAAAAAAAAAAAAAkAAAAJAAAAAAAAAAHAAAAAAAAAAAAAAAAAAAAAAAAAAAAAAAAAAAAf39/ACUAAABYAAAAAAAAAAAAAAAAAAAAAAAAAAAAAAAAAAAAAAAAAAAAAAAAAAAAAAAAAAAAAAA/AAAAAAAAAKCGAQAAAAAAAAAAAAAAAAAMAAAAAQAAAAAAAAAAAAAAAAAAAB8AAABUAAAA+/v+AP///wEAAAAAAAAAAAAAAAAAAAAAAAAAAAAAAAAAAAAAAAAAAAAAAAJ/f38AWVlZA8zMzADAwP8Af39/AAAAAAAAAAAAAAAAAAAAAAAAAAAAIQAAABgAAAAUAAAAuwMAAPIJAACQNAAALycAABAAAAAmAAAACAAAAP//////////"/>
               </a:ext>
             </a:extLst>
           </p:cNvSpPr>
@@ -2699,7 +2699,7 @@
             <a:spLocks noGrp="1" noChangeArrowheads="1"/>
             <a:extLst>
               <a:ext uri="smNativeData">
-                <pr:smNativeData xmlns:pr="smNativeData" xmlns="smNativeData" val="SMDATA_15_FUV5ZhMAAAAlAAAAZAAAAA0AAAAAkAAAAJAAAACQAAAAkAAAAAAAAAAAAAAAAAAAAAEAAABQAAAAAAAAAAAA4D8AAAAAAADgPwAAAAAAAOA/AAAAAAAA4D8AAAAAAADgPwAAAAAAAOA/AAAAAAAA4D8AAAAAAADgPwAAAAAAAOA/AAAAAAAA4D8CAAAAjAAAAAAAAAAAAAAAQoX0DP///wgAAAAAAAAAAAAAAAAAAAAAAAAAAAAAAAAAAAAAZAAAAAEAAABAAAAAAAAAAAAAAAAAAAAAAAAAAAAAAAAAAAAAAAAAAAAAAAAAAAAAAAAAAAAAAAAAAAAAAAAAAAAAAAAAAAAAAAAAAAAAAAAAAAAAAAAAAAAAAAAAAAAAFAAAADwAAAAAAAAAAAAAAAAAAAkUAAAAAQAAABQAAAAUAAAAFAAAAAEAAAAAAAAAZAAAAGQAAAAAAAAAZAAAAGQAAAAVAAAAYAAAAAAAAAAAAAAADwAAACADAAAAAAAAAAAAAAEAAACgMgAAVgcAAKr4//8BAAAAf39/AAEAAABkAAAAAAAAABQAAABAHwAAAAAAACYAAAAAAAAAwOD//wAAAAAmAAAAZAAAABYAAABMAAAAAAAAAAAAAAAEAAAAAAAAAAEAAABZWVkKAAAAACgAAAAoAAAAZAAAAGQAAAAAAAAAzMzMAAAAAABQAAAAUAAAAGQAAABkAAAAAAAAABcAAAAUAAAAAAAAAAAAAAD/fwAA/38AAAAAAAAJAAAABAAAAAAAAAAeAAAAaAAAAAAAAAAAAAAAAAAAAAAAAAAAAAAAECcAABAnAAAAAAAAAAAAAAAAAAAAAAAAAAAAAAAAAAAAAAAAAAAAABQAAAAAAAAAwMD/AAAAAABkAAAAMgAAAAAAAABkAAAAAAAAAH9/fwAKAAAAIgAAABgAAAAAAAAAAAAAAAAAAAAAAAAAAAAAAAAAAAAkAAAAJAAAAAAAAAAHAAAAAAAAAAAAAAAAAAAAAAAAAAAAAAAAAAAAf39/ACUAAABYAAAAAAAAAAAAAAAAAAAAAAAAAAAAAAAAAAAAAAAAAAAAAAAAAAAAAAAAAAAAAAA/AAAAAAAAAKCGAQAAAAAAAAAAAAAAAAAMAAAAAQAAAAAAAAAAAAAAAAAAAB8AAABUAAAAAAAABQAAAAEAAAAAAAAAAAAAAAAAAAAAAAAAAAAAAAAAAAAAAAAAAAAAAAJ/f38AAAAAA8zMzADAwP8Af39/AAAAAAAAAAAAAAAAAAAAAAAAAAAAIQAAABgAAAAUAAAAfAQAANkKAAC5NQAAMCcAABAAAAAmAAAACAAAAD2wAAAAAAAA"/>
+                <pr:smNativeData xmlns:pr="smNativeData" xmlns="smNativeData" val="SMDATA_15_9kV5ZhMAAAAlAAAAZAAAAA0AAAAAkAAAAJAAAACQAAAAkAAAAAAAAAAAAAAAAAAAAAEAAABQAAAAAAAAAAAA4D8AAAAAAADgPwAAAAAAAOA/AAAAAAAA4D8AAAAAAADgPwAAAAAAAOA/AAAAAAAA4D8AAAAAAADgPwAAAAAAAOA/AAAAAAAA4D8CAAAAjAAAAAAAAAAAAAAAQoX0DP///wgAAAAAAAAAAAAAAAAAAAAAAAAAAAAAAAAAAAAAZAAAAAEAAABAAAAAAAAAAAAAAAAAAAAAAAAAAAAAAAAAAAAAAAAAAAAAAAAAAAAAAAAAAAAAAAAAAAAAAAAAAAAAAAAAAAAAAAAAAAAAAAAAAAAAAAAAAAAAAAAAAAAAFAAAADwAAAAAAAAAAAAAAAAAAAkUAAAAAQAAABQAAAAUAAAAFAAAAAEAAAAAAAAAZAAAAGQAAAAAAAAAZAAAAGQAAAAVAAAAYAAAAAAAAAAAAAAADwAAACADAAAAAAAAAAAAAAEAAACgMgAAVgcAAKr4//8BAAAAf39/AAEAAABkAAAAAAAAABQAAABAHwAAAAAAACYAAAAAAAAAwOD//wAAAAAmAAAAZAAAABYAAABMAAAAAAAAAAAAAAAEAAAAAAAAAAEAAABZWVkKAAAAACgAAAAoAAAAZAAAAGQAAAAAAAAAzMzMAAAAAABQAAAAUAAAAGQAAABkAAAAAAAAABcAAAAUAAAAAAAAAAAAAAD/fwAA/38AAAAAAAAJAAAABAAAAAAAAAAeAAAAaAAAAAAAAAAAAAAAAAAAAAAAAAAAAAAAECcAABAnAAAAAAAAAAAAAAAAAAAAAAAAAAAAAAAAAAAAAAAAAAAAABQAAAAAAAAAwMD/AAAAAABkAAAAMgAAAAAAAABkAAAAAAAAAH9/fwAKAAAAIgAAABgAAAAAAAAAAAAAAAAAAAAAAAAAAAAAAAAAAAAkAAAAJAAAAAAAAAAHAAAAAAAAAAAAAAAAAAAAAAAAAAAAAAAAAAAAf39/ACUAAABYAAAAAAAAAAAAAAAAAAAAAAAAAAAAAAAAAAAAAAAAAAAAAAAAAAAAAAAAAAAAAAA/AAAAAAAAAKCGAQAAAAAAAAAAAAAAAAAMAAAAAQAAAAAAAAAAAAAAAAAAAB8AAABUAAAAAAAABQAAAAEAAAAAAAAAAAAAAAAAAAAAAAAAAAAAAAAAAAAAAAAAAAAAAAJ/f38AAAAAA8zMzADAwP8Af39/AAAAAAAAAAAAAAAAAAAAAAAAAAAAIQAAABgAAAAUAAAAfAQAANkKAAC5NQAAMCcAABAAAAAmAAAACAAAAD2wAAAAAAAA"/>
               </a:ext>
             </a:extLst>
           </p:cNvSpPr>
@@ -2879,7 +2879,7 @@
             <a:spLocks noGrp="1" noChangeArrowheads="1"/>
             <a:extLst>
               <a:ext uri="smNativeData">
-                <pr:smNativeData xmlns:pr="smNativeData" xmlns="smNativeData" val="SMDATA_15_FUV5ZhMAAAAlAAAAZAAAAA0AAAAAkAAAAJAAAACQAAAAkAAAAAAAAAAAAAAAAAAAAAEAAABQAAAAAAAAAAAA4D8AAAAAAADgPwAAAAAAAOA/AAAAAAAA4D8AAAAAAADgPwAAAAAAAOA/AAAAAAAA4D8AAAAAAADgPwAAAAAAAOA/AAAAAAAA4D8CAAAAjAAAAAAAAAAAAAAAQoX0DP///wgAAAAAAAAAAAAAAAAAAAAAAAAAAAAAAAAAAAAAZAAAAAEAAABAAAAAAAAAAAAAAAAAAAAAAAAAAAAAAAAAAAAAAAAAAAAAAAAAAAAAAAAAAAAAAAAAAAAAAAAAAAAAAAAAAAAAAAAAAAAAAAAAAAAAAAAAAAAAAAAAAAAAFAAAADwAAAAAAAAAAAAAAAAAAAkUAAAAAQAAABQAAAAUAAAAFAAAAAEAAAAAAAAAZAAAAGQAAAAAAAAAZAAAAGQAAAAVAAAAYAAAAAAAAAAAAAAADwAAACADAAAAAAAAAAAAAAEAAACgMgAAVgcAAKr4//8BAAAAf39/AAEAAABkAAAAAAAAABQAAABAHwAAAAAAACYAAAAAAAAAwOD//wAAAAAmAAAAZAAAABYAAABMAAAAAAAAAAAAAAAEAAAAAAAAAAEAAABZWVkKAAAAACgAAAAoAAAAZAAAAGQAAAAAAAAAzMzMAAAAAABQAAAAUAAAAGQAAABkAAAAAAAAABcAAAAUAAAAAAAAAAAAAAD/fwAA/38AAAAAAAAJAAAABAAAAAAAAAAeAAAAaAAAAAAAAAAAAAAAAAAAAAAAAAAAAAAAECcAABAnAAAAAAAAAAAAAAAAAAAAAAAAAAAAAAAAAAAAAAAAAAAAABQAAAAAAAAAwMD/AAAAAABkAAAAMgAAAAAAAABkAAAAAAAAAH9/fwAKAAAAIgAAABgAAAAAAAAAAAAAAAAAAAAAAAAAAAAAAAAAAAAkAAAAJAAAAAAAAAAHAAAAAAAAAAAAAAAAAAAAAAAAAAAAAAAAAAAAf39/ACUAAABYAAAAAAAAAAAAAAAAAAAAAAAAAAAAAAAAAAAAAAAAAAAAAAAAAAAAAAAAAAAAAAA/AAAAAAAAAKCGAQAAAAAAAAAAAAAAAAAMAAAAAQAAAAAAAAAAAAAAAAAAAB8AAABUAAAAAAAABQAAAAEAAAAAAAAAAAAAAAAAAAAAAAAAAAAAAAAAAAAAAAAAAAAAAAJ/f38AAAAAA8zMzADAwP8Af39/AAAAAAAAAAAAAAAAAAAAAAAAAAAAIQAAABgAAAAUAAAAFAMAALYCAAB/NwAAvwoAABAAAAAmAAAACAAAADywAAAAAAAA"/>
+                <pr:smNativeData xmlns:pr="smNativeData" xmlns="smNativeData" val="SMDATA_15_9kV5ZhMAAAAlAAAAZAAAAA0AAAAAkAAAAJAAAACQAAAAkAAAAAAAAAAAAAAAAAAAAAEAAABQAAAAAAAAAAAA4D8AAAAAAADgPwAAAAAAAOA/AAAAAAAA4D8AAAAAAADgPwAAAAAAAOA/AAAAAAAA4D8AAAAAAADgPwAAAAAAAOA/AAAAAAAA4D8CAAAAjAAAAAAAAAAAAAAAQoX0DP///wgAAAAAAAAAAAAAAAAAAAAAAAAAAAAAAAAAAAAAZAAAAAEAAABAAAAAAAAAAAAAAAAAAAAAAAAAAAAAAAAAAAAAAAAAAAAAAAAAAAAAAAAAAAAAAAAAAAAAAAAAAAAAAAAAAAAAAAAAAAAAAAAAAAAAAAAAAAAAAAAAAAAAFAAAADwAAAAAAAAAAAAAAAAAAAkUAAAAAQAAABQAAAAUAAAAFAAAAAEAAAAAAAAAZAAAAGQAAAAAAAAAZAAAAGQAAAAVAAAAYAAAAAAAAAAAAAAADwAAACADAAAAAAAAAAAAAAEAAACgMgAAVgcAAKr4//8BAAAAf39/AAEAAABkAAAAAAAAABQAAABAHwAAAAAAACYAAAAAAAAAwOD//wAAAAAmAAAAZAAAABYAAABMAAAAAAAAAAAAAAAEAAAAAAAAAAEAAABZWVkKAAAAACgAAAAoAAAAZAAAAGQAAAAAAAAAzMzMAAAAAABQAAAAUAAAAGQAAABkAAAAAAAAABcAAAAUAAAAAAAAAAAAAAD/fwAA/38AAAAAAAAJAAAABAAAAAAAAAAeAAAAaAAAAAAAAAAAAAAAAAAAAAAAAAAAAAAAECcAABAnAAAAAAAAAAAAAAAAAAAAAAAAAAAAAAAAAAAAAAAAAAAAABQAAAAAAAAAwMD/AAAAAABkAAAAMgAAAAAAAABkAAAAAAAAAH9/fwAKAAAAIgAAABgAAAAAAAAAAAAAAAAAAAAAAAAAAAAAAAAAAAAkAAAAJAAAAAAAAAAHAAAAAAAAAAAAAAAAAAAAAAAAAAAAAAAAAAAAf39/ACUAAABYAAAAAAAAAAAAAAAAAAAAAAAAAAAAAAAAAAAAAAAAAAAAAAAAAAAAAAAAAAAAAAA/AAAAAAAAAKCGAQAAAAAAAAAAAAAAAAAMAAAAAQAAAAAAAAAAAAAAAAAAAB8AAABUAAAAAAAABQAAAAEAAAAAAAAAAAAAAAAAAAAAAAAAAAAAAAAAAAAAAAAAAAAAAAJ/f38AAAAAA8zMzADAwP8Af39/AAAAAAAAAAAAAAAAAAAAAAAAAAAAIQAAABgAAAAUAAAAFAMAALYCAAB/NwAAvwoAABAAAAAmAAAACAAAADywAAAAAAAA"/>
               </a:ext>
             </a:extLst>
           </p:cNvSpPr>
@@ -2988,7 +2988,7 @@
           <p:cNvSpPr>
             <a:extLst>
               <a:ext uri="smNativeData">
-                <pr:smNativeData xmlns:pr="smNativeData" xmlns="smNativeData" val="SMDATA_15_FUV5ZhMAAAAlAAAAZAAAAA0AAAAAkAAAAJAAAACQAAAAkAAAAAAAAAABAAAAAAAAAAEAAABQAAAAAAAAAAAA4D8AAAAAAADgPwAAAAAAAOA/AAAAAAAA4D8AAAAAAADgPwAAAAAAAOA/AAAAAAAA4D8AAAAAAADgPwAAAAAAAOA/AAAAAAAA4D8CAAAAjAAAAAEAAAAAAAAAISEhDf///wgAAAAAAAAAAAAAAAAAAAAAAAAAAAAAAAAAAAAAeAAAAAEAAABAAAAAAAAAAAAAAABaAAAAAAAAAAAAAAAAAAAAAAAAAAAAAAAAAAAAAAAAAAAAAAAAAAAAAAAAAAAAAAAAAAAAAAAAAAAAAAAAAAAAAAAAAAAAAAAAAAAAFAAAADwAAAAAAAAAAAAAAAAAAAkUAAAAAQAAABQAAAAUAAAAFAAAAAEAAAAAAAAAZAAAAGQAAAAAAAAAZAAAAGQAAAAVAAAAYAAAAAAAAAAAAAAADwAAACADAAAAAAAAAAAAAAEAAACgMgAAVgcAAKr4//8BAAAAf39/AAEAAABkAAAAAAAAABQAAABAHwAAAAAAACYAAAAAAAAAwOD//wAAAAAmAAAAZAAAABYAAABMAAAAAAAAAAAAAAAEAAAAAAAAAAEAAABZWVkKAAAAACgAAAAoAAAAZAAAAGQAAAAAAAAAzMzMAAAAAABQAAAAUAAAAGQAAABkAAAAAAAAABcAAAAUAAAAAAAAAAAAAAD/fwAA/38AAAAAAAAJAAAABAAAAAAAAAAeAAAAaAAAAAAAAAAAAAAAAAAAAAAAAAAAAAAAECcAABAnAAAAAAAAAAAAAAAAAAAAAAAAAAAAAAAAAAAAAAAAAAAAABQAAAAAAAAAwMD/AAAAAABkAAAAMgAAAAAAAABkAAAAAAAAAH9/fwAKAAAAIgAAABgAAAAAAAAAAAAAAAAAAAAAAAAAAAAAAAAAAAAkAAAAJAAAAAAAAAAHAAAAAAAAAAAAAAAAAAAAAAAAAAAAAAAAAAAAf39/ACUAAABYAAAAAAAAAAAAAAAAAAAAAAAAAAAAAAAAAAAAAAAAAAAAAAAAAAAAAAAAAAAAAAA/AAAAAAAAAKCGAQAAAAAAAAAAAAAAAAAMAAAAAQAAAAAAAAAAAAAAAAAAAB8AAABUAAAAAAAABgAAAAEAAAAAAAAAAAAAAAAAAAAAAAAAAAAAAAAAAAAAAAAAAAAAAAJ/f38AAAAAA8zMzADAwP8Af39/AAAAAAAAAAAAAAAAAAAAAAAAAAAAIQAAABgAAAAUAAAAuwMAAPIJAACQNAAALycAABAAAAAmAAAACAAAAP//////////"/>
+                <pr:smNativeData xmlns:pr="smNativeData" xmlns="smNativeData" val="SMDATA_15_9kV5ZhMAAAAlAAAAZAAAAA0AAAAAkAAAAJAAAACQAAAAkAAAAAAAAAABAAAAAAAAAAEAAABQAAAAAAAAAAAA4D8AAAAAAADgPwAAAAAAAOA/AAAAAAAA4D8AAAAAAADgPwAAAAAAAOA/AAAAAAAA4D8AAAAAAADgPwAAAAAAAOA/AAAAAAAA4D8CAAAAjAAAAAEAAAAAAAAAISEhDf///wgAAAAAAAAAAAAAAAAAAAAAAAAAAAAAAAAAAAAAeAAAAAEAAABAAAAAAAAAAAAAAABaAAAAAAAAAAAAAAAAAAAAAAAAAAAAAAAAAAAAAAAAAAAAAAAAAAAAAAAAAAAAAAAAAAAAAAAAAAAAAAAAAAAAAAAAAAAAAAAAAAAAFAAAADwAAAAAAAAAAAAAAAAAAAkUAAAAAQAAABQAAAAUAAAAFAAAAAEAAAAAAAAAZAAAAGQAAAAAAAAAZAAAAGQAAAAVAAAAYAAAAAAAAAAAAAAADwAAACADAAAAAAAAAAAAAAEAAACgMgAAVgcAAKr4//8BAAAAf39/AAEAAABkAAAAAAAAABQAAABAHwAAAAAAACYAAAAAAAAAwOD//wAAAAAmAAAAZAAAABYAAABMAAAAAAAAAAAAAAAEAAAAAAAAAAEAAABZWVkKAAAAACgAAAAoAAAAZAAAAGQAAAAAAAAAzMzMAAAAAABQAAAAUAAAAGQAAABkAAAAAAAAABcAAAAUAAAAAAAAAAAAAAD/fwAA/38AAAAAAAAJAAAABAAAAAAAAAAeAAAAaAAAAAAAAAAAAAAAAAAAAAAAAAAAAAAAECcAABAnAAAAAAAAAAAAAAAAAAAAAAAAAAAAAAAAAAAAAAAAAAAAABQAAAAAAAAAwMD/AAAAAABkAAAAMgAAAAAAAABkAAAAAAAAAH9/fwAKAAAAIgAAABgAAAAAAAAAAAAAAAAAAAAAAAAAAAAAAAAAAAAkAAAAJAAAAAAAAAAHAAAAAAAAAAAAAAAAAAAAAAAAAAAAAAAAAAAAf39/ACUAAABYAAAAAAAAAAAAAAAAAAAAAAAAAAAAAAAAAAAAAAAAAAAAAAAAAAAAAAAAAAAAAAA/AAAAAAAAAKCGAQAAAAAAAAAAAAAAAAAMAAAAAQAAAAAAAAAAAAAAAAAAAB8AAABUAAAAAAAABgAAAAEAAAAAAAAAAAAAAAAAAAAAAAAAAAAAAAAAAAAAAAAAAAAAAAJ/f38AAAAAA8zMzADAwP8Af39/AAAAAAAAAAAAAAAAAAAAAAAAAAAAIQAAABgAAAAUAAAAuwMAAPIJAACQNAAALycAABAAAAAmAAAACAAAAP//////////"/>
               </a:ext>
             </a:extLst>
           </p:cNvSpPr>
@@ -3033,7 +3033,7 @@
             <a:spLocks noGrp="1" noChangeArrowheads="1"/>
             <a:extLst>
               <a:ext uri="smNativeData">
-                <pr:smNativeData xmlns:pr="smNativeData" xmlns="smNativeData" val="SMDATA_15_FUV5ZhMAAAAlAAAAZAAAAA0AAAAAkAAAAJAAAACQAAAAkAAAAAAAAAAAAAAAAAAAAAEAAABQAAAAAAAAAAAA4D8AAAAAAADgPwAAAAAAAOA/AAAAAAAA4D8AAAAAAADgPwAAAAAAAOA/AAAAAAAA4D8AAAAAAADgPwAAAAAAAOA/AAAAAAAA4D8CAAAAjAAAAAAAAAAAAAAAQoX0DP///wgAAAAAAAAAAAAAAAAAAAAAAAAAAAAAAAAAAAAAZAAAAAEAAABAAAAAAAAAAAAAAAAAAAAAAAAAAAAAAAAAAAAAAAAAAAAAAAAAAAAAAAAAAAAAAAAAAAAAAAAAAAAAAAAAAAAAAAAAAAAAAAAAAAAAAAAAAAAAAAAAAAAAFAAAADwAAAAAAAAAAAAAAAAAAAkUAAAAAQAAABQAAAAUAAAAFAAAAAEAAAAAAAAAZAAAAGQAAAAAAAAAZAAAAGQAAAAVAAAAYAAAAAAAAAAAAAAADwAAACADAAAAAAAAAAAAAAEAAACgMgAAVgcAAKr4//8BAAAAf39/AAEAAABkAAAAAAAAABQAAABAHwAAAAAAACYAAAAAAAAAwOD//wAAAAAmAAAAZAAAABYAAABMAAAAAAAAAAAAAAAEAAAAAAAAAAEAAABZWVkKAAAAACgAAAAoAAAAZAAAAGQAAAAAAAAAzMzMAAAAAABQAAAAUAAAAGQAAABkAAAAAAAAABcAAAAUAAAAAAAAAAAAAAD/fwAA/38AAAAAAAAJAAAABAAAAAAAAAAeAAAAaAAAAAAAAAAAAAAAAAAAAAAAAAAAAAAAECcAABAnAAAAAAAAAAAAAAAAAAAAAAAAAAAAAAAAAAAAAAAAAAAAABQAAAAAAAAAwMD/AAAAAABkAAAAMgAAAAAAAABkAAAAAAAAAH9/fwAKAAAAIgAAABgAAAAAAAAAAAAAAAAAAAAAAAAAAAAAAAAAAAAkAAAAJAAAAAAAAAAHAAAAAAAAAAAAAAAAAAAAAAAAAAAAAAAAAAAAf39/ACUAAABYAAAAAAAAAAAAAAAAAAAAAAAAAAAAAAAAAAAAAAAAAAAAAAAAAAAAAAAAAAAAAAA/AAAAAAAAAKCGAQAAAAAAAAAAAAAAAAAMAAAAAQAAAAAAAAAAAAAAAAAAAB8AAABUAAAAAAAABQAAAAEAAAAAAAAAAAAAAAAAAAAAAAAAAAAAAAAAAAAAAAAAAAAAAAJ/f38AAAAAA8zMzADAwP8Af39/AAAAAAAAAAAAAAAAAAAAAAAAAAAAIQAAABgAAAAUAAAAfAQAANkKAAC5NQAAMCcAABAAAAAmAAAACAAAAD2wAAAAAAAA"/>
+                <pr:smNativeData xmlns:pr="smNativeData" xmlns="smNativeData" val="SMDATA_15_9kV5ZhMAAAAlAAAAZAAAAA0AAAAAkAAAAJAAAACQAAAAkAAAAAAAAAAAAAAAAAAAAAEAAABQAAAAAAAAAAAA4D8AAAAAAADgPwAAAAAAAOA/AAAAAAAA4D8AAAAAAADgPwAAAAAAAOA/AAAAAAAA4D8AAAAAAADgPwAAAAAAAOA/AAAAAAAA4D8CAAAAjAAAAAAAAAAAAAAAQoX0DP///wgAAAAAAAAAAAAAAAAAAAAAAAAAAAAAAAAAAAAAZAAAAAEAAABAAAAAAAAAAAAAAAAAAAAAAAAAAAAAAAAAAAAAAAAAAAAAAAAAAAAAAAAAAAAAAAAAAAAAAAAAAAAAAAAAAAAAAAAAAAAAAAAAAAAAAAAAAAAAAAAAAAAAFAAAADwAAAAAAAAAAAAAAAAAAAkUAAAAAQAAABQAAAAUAAAAFAAAAAEAAAAAAAAAZAAAAGQAAAAAAAAAZAAAAGQAAAAVAAAAYAAAAAAAAAAAAAAADwAAACADAAAAAAAAAAAAAAEAAACgMgAAVgcAAKr4//8BAAAAf39/AAEAAABkAAAAAAAAABQAAABAHwAAAAAAACYAAAAAAAAAwOD//wAAAAAmAAAAZAAAABYAAABMAAAAAAAAAAAAAAAEAAAAAAAAAAEAAABZWVkKAAAAACgAAAAoAAAAZAAAAGQAAAAAAAAAzMzMAAAAAABQAAAAUAAAAGQAAABkAAAAAAAAABcAAAAUAAAAAAAAAAAAAAD/fwAA/38AAAAAAAAJAAAABAAAAAAAAAAeAAAAaAAAAAAAAAAAAAAAAAAAAAAAAAAAAAAAECcAABAnAAAAAAAAAAAAAAAAAAAAAAAAAAAAAAAAAAAAAAAAAAAAABQAAAAAAAAAwMD/AAAAAABkAAAAMgAAAAAAAABkAAAAAAAAAH9/fwAKAAAAIgAAABgAAAAAAAAAAAAAAAAAAAAAAAAAAAAAAAAAAAAkAAAAJAAAAAAAAAAHAAAAAAAAAAAAAAAAAAAAAAAAAAAAAAAAAAAAf39/ACUAAABYAAAAAAAAAAAAAAAAAAAAAAAAAAAAAAAAAAAAAAAAAAAAAAAAAAAAAAAAAAAAAAA/AAAAAAAAAKCGAQAAAAAAAAAAAAAAAAAMAAAAAQAAAAAAAAAAAAAAAAAAAB8AAABUAAAAAAAABQAAAAEAAAAAAAAAAAAAAAAAAAAAAAAAAAAAAAAAAAAAAAAAAAAAAAJ/f38AAAAAA8zMzADAwP8Af39/AAAAAAAAAAAAAAAAAAAAAAAAAAAAIQAAABgAAAAUAAAAfAQAANkKAAC5NQAAMCcAABAAAAAmAAAACAAAAD2wAAAAAAAA"/>
               </a:ext>
             </a:extLst>
           </p:cNvSpPr>
@@ -3248,7 +3248,7 @@
             <a:spLocks noGrp="1" noChangeArrowheads="1"/>
             <a:extLst>
               <a:ext uri="smNativeData">
-                <pr:smNativeData xmlns:pr="smNativeData" xmlns="smNativeData" val="SMDATA_15_FUV5ZhMAAAAlAAAAZAAAAA0AAAAAkAAAAJAAAACQAAAAkAAAAAAAAAAAAAAAAAAAAAEAAABQAAAAAAAAAAAA4D8AAAAAAADgPwAAAAAAAOA/AAAAAAAA4D8AAAAAAADgPwAAAAAAAOA/AAAAAAAA4D8AAAAAAADgPwAAAAAAAOA/AAAAAAAA4D8CAAAAjAAAAAAAAAAAAAAAQoX0DP///wgAAAAAAAAAAAAAAAAAAAAAAAAAAAAAAAAAAAAAZAAAAAEAAABAAAAAAAAAAAAAAAAAAAAAAAAAAAAAAAAAAAAAAAAAAAAAAAAAAAAAAAAAAAAAAAAAAAAAAAAAAAAAAAAAAAAAAAAAAAAAAAAAAAAAAAAAAAAAAAAAAAAAFAAAADwAAAAAAAAAAAAAAAAAAAkUAAAAAQAAABQAAAAUAAAAFAAAAAEAAAAAAAAAZAAAAGQAAAAAAAAAZAAAAGQAAAAVAAAAYAAAAAAAAAAAAAAADwAAACADAAAAAAAAAAAAAAEAAACgMgAAVgcAAKr4//8BAAAAf39/AAEAAABkAAAAAAAAABQAAABAHwAAAAAAACYAAAAAAAAAwOD//wAAAAAmAAAAZAAAABYAAABMAAAAAAAAAAAAAAAEAAAAAAAAAAEAAABZWVkKAAAAACgAAAAoAAAAZAAAAGQAAAAAAAAAzMzMAAAAAABQAAAAUAAAAGQAAABkAAAAAAAAABcAAAAUAAAAAAAAAAAAAAD/fwAA/38AAAAAAAAJAAAABAAAAAAAAAAeAAAAaAAAAAAAAAAAAAAAAAAAAAAAAAAAAAAAECcAABAnAAAAAAAAAAAAAAAAAAAAAAAAAAAAAAAAAAAAAAAAAAAAABQAAAAAAAAAwMD/AAAAAABkAAAAMgAAAAAAAABkAAAAAAAAAH9/fwAKAAAAIgAAABgAAAAAAAAAAAAAAAAAAAAAAAAAAAAAAAAAAAAkAAAAJAAAAAAAAAAHAAAAAAAAAAAAAAAAAAAAAAAAAAAAAAAAAAAAf39/ACUAAABYAAAAAAAAAAAAAAAAAAAAAAAAAAAAAAAAAAAAAAAAAAAAAAAAAAAAAAAAAAAAAAA/AAAAAAAAAKCGAQAAAAAAAAAAAAAAAAAMAAAAAQAAAAAAAAAAAAAAAAAAAB8AAABUAAAAAAAABQAAAAEAAAAAAAAAAAAAAAAAAAAAAAAAAAAAAAAAAAAAAAAAAAAAAAJ/f38AAAAAA8zMzADAwP8Af39/AAAAAAAAAAAAAAAAAAAAAAAAAAAAIQAAABgAAAAUAAAAFAMAALYCAAB/NwAAvwoAABAAAAAmAAAACAAAADywAAAAAAAA"/>
+                <pr:smNativeData xmlns:pr="smNativeData" xmlns="smNativeData" val="SMDATA_15_9kV5ZhMAAAAlAAAAZAAAAA0AAAAAkAAAAJAAAACQAAAAkAAAAAAAAAAAAAAAAAAAAAEAAABQAAAAAAAAAAAA4D8AAAAAAADgPwAAAAAAAOA/AAAAAAAA4D8AAAAAAADgPwAAAAAAAOA/AAAAAAAA4D8AAAAAAADgPwAAAAAAAOA/AAAAAAAA4D8CAAAAjAAAAAAAAAAAAAAAQoX0DP///wgAAAAAAAAAAAAAAAAAAAAAAAAAAAAAAAAAAAAAZAAAAAEAAABAAAAAAAAAAAAAAAAAAAAAAAAAAAAAAAAAAAAAAAAAAAAAAAAAAAAAAAAAAAAAAAAAAAAAAAAAAAAAAAAAAAAAAAAAAAAAAAAAAAAAAAAAAAAAAAAAAAAAFAAAADwAAAAAAAAAAAAAAAAAAAkUAAAAAQAAABQAAAAUAAAAFAAAAAEAAAAAAAAAZAAAAGQAAAAAAAAAZAAAAGQAAAAVAAAAYAAAAAAAAAAAAAAADwAAACADAAAAAAAAAAAAAAEAAACgMgAAVgcAAKr4//8BAAAAf39/AAEAAABkAAAAAAAAABQAAABAHwAAAAAAACYAAAAAAAAAwOD//wAAAAAmAAAAZAAAABYAAABMAAAAAAAAAAAAAAAEAAAAAAAAAAEAAABZWVkKAAAAACgAAAAoAAAAZAAAAGQAAAAAAAAAzMzMAAAAAABQAAAAUAAAAGQAAABkAAAAAAAAABcAAAAUAAAAAAAAAAAAAAD/fwAA/38AAAAAAAAJAAAABAAAAAAAAAAeAAAAaAAAAAAAAAAAAAAAAAAAAAAAAAAAAAAAECcAABAnAAAAAAAAAAAAAAAAAAAAAAAAAAAAAAAAAAAAAAAAAAAAABQAAAAAAAAAwMD/AAAAAABkAAAAMgAAAAAAAABkAAAAAAAAAH9/fwAKAAAAIgAAABgAAAAAAAAAAAAAAAAAAAAAAAAAAAAAAAAAAAAkAAAAJAAAAAAAAAAHAAAAAAAAAAAAAAAAAAAAAAAAAAAAAAAAAAAAf39/ACUAAABYAAAAAAAAAAAAAAAAAAAAAAAAAAAAAAAAAAAAAAAAAAAAAAAAAAAAAAAAAAAAAAA/AAAAAAAAAKCGAQAAAAAAAAAAAAAAAAAMAAAAAQAAAAAAAAAAAAAAAAAAAB8AAABUAAAAAAAABQAAAAEAAAAAAAAAAAAAAAAAAAAAAAAAAAAAAAAAAAAAAAAAAAAAAAJ/f38AAAAAA8zMzADAwP8Af39/AAAAAAAAAAAAAAAAAAAAAAAAAAAAIQAAABgAAAAUAAAAFAMAALYCAAB/NwAAvwoAABAAAAAmAAAACAAAADywAAAAAAAA"/>
               </a:ext>
             </a:extLst>
           </p:cNvSpPr>
@@ -3357,7 +3357,7 @@
           <p:cNvSpPr>
             <a:extLst>
               <a:ext uri="smNativeData">
-                <pr:smNativeData xmlns:pr="smNativeData" xmlns="smNativeData" val="SMDATA_15_FUV5ZhMAAAAlAAAAZAAAAA0AAAAAkAAAAJAAAACQAAAAkAAAAAAAAAABAAAAAAAAAAEAAABQAAAAAAAAAAAA4D8AAAAAAADgPwAAAAAAAOA/AAAAAAAA4D8AAAAAAADgPwAAAAAAAOA/AAAAAAAA4D8AAAAAAADgPwAAAAAAAOA/AAAAAAAA4D8CAAAAjAAAAAEAAAAAAAAA+/v+AP///wgAAAAAAAAAAAAAAAAAAAAAAAAAAAAAAAAAAAAAeAAAAAEAAABAAAAAAAAAAAAAAABaAAAAAAAAAAAAAAAAAAAAAAAAAAAAAAAAAAAAAAAAAAAAAAAAAAAAAAAAAAAAAAAAAAAAAAAAAAAAAAAAAAAAAAAAAAAAAAAAAAAAFAAAADwAAAAAAAAAAAAAAAAAAAkUAAAAAQAAABQAAAAUAAAAFAAAAAEAAAAAAAAAZAAAAGQAAAAAAAAAZAAAAGQAAAAVAAAAYAAAAAAAAAAAAAAADwAAACADAAAAAAAAAAAAAAEAAACgMgAAVgcAAKr4//8BAAAAf39/AAEAAABkAAAAAAAAABQAAABAHwAAAAAAACYAAAAAAAAAwOD//wAAAAAmAAAAZAAAABYAAABMAAAAAAAAAAAAAAAEAAAAAAAAAAEAAABZWVkKAAAAACgAAAAoAAAAZAAAAGQAAAAAAAAAzMzMAAAAAABQAAAAUAAAAGQAAABkAAAAAAAAABcAAAAUAAAAAAAAAAAAAAD/fwAA/38AAAAAAAAJAAAABAAAAAAAAAAeAAAAaAAAAAAAAAAAAAAAAAAAAAAAAAAAAAAAECcAABAnAAAAAAAAAAAAAAAAAAAAAAAAAAAAAAAAAAAAAAAAAAAAABQAAAAAAAAAwMD/AAAAAABkAAAAMgAAAAAAAABkAAAAAAAAAH9/fwAKAAAAIgAAABgAAAAAAAAAAAAAAAAAAAAAAAAAAAAAAAAAAAAkAAAAJAAAAAAAAAAHAAAAAAAAAAAAAAAAAAAAAAAAAAAAAAAAAAAAf39/ACUAAABYAAAAAAAAAAAAAAAAAAAAAAAAAAAAAAAAAAAAAAAAAAAAAAAAAAAAAAAAAAAAAAA/AAAAAAAAAKCGAQAAAAAAAAAAAAAAAAAMAAAAAQAAAAAAAAAAAAAAAAAAAB8AAABUAAAA+/v+AAAAAAEAAAAAAAAAAAAAAAAAAAAAAAAAAAAAAAAAAAAAAAAAAAAAAAJ/f38AAAAAA8zMzADAwP8Af39/AAAAAAAAAAAAAAAAAAAAAAAAAAAAIQAAABgAAAAUAAAAuwMAAJYRAACQNAAAzSUAABAAAAAmAAAACAAAAP//////////"/>
+                <pr:smNativeData xmlns:pr="smNativeData" xmlns="smNativeData" val="SMDATA_15_9kV5ZhMAAAAlAAAAZAAAAA0AAAAAkAAAAJAAAACQAAAAkAAAAAAAAAABAAAAAAAAAAEAAABQAAAAAAAAAAAA4D8AAAAAAADgPwAAAAAAAOA/AAAAAAAA4D8AAAAAAADgPwAAAAAAAOA/AAAAAAAA4D8AAAAAAADgPwAAAAAAAOA/AAAAAAAA4D8CAAAAjAAAAAEAAAAAAAAA+/v+AP///wgAAAAAAAAAAAAAAAAAAAAAAAAAAAAAAAAAAAAAeAAAAAEAAABAAAAAAAAAAAAAAABaAAAAAAAAAAAAAAAAAAAAAAAAAAAAAAAAAAAAAAAAAAAAAAAAAAAAAAAAAAAAAAAAAAAAAAAAAAAAAAAAAAAAAAAAAAAAAAAAAAAAFAAAADwAAAAAAAAAAAAAAAAAAAkUAAAAAQAAABQAAAAUAAAAFAAAAAEAAAAAAAAAZAAAAGQAAAAAAAAAZAAAAGQAAAAVAAAAYAAAAAAAAAAAAAAADwAAACADAAAAAAAAAAAAAAEAAACgMgAAVgcAAKr4//8BAAAAf39/AAEAAABkAAAAAAAAABQAAABAHwAAAAAAACYAAAAAAAAAwOD//wAAAAAmAAAAZAAAABYAAABMAAAAAAAAAAAAAAAEAAAAAAAAAAEAAABZWVkKAAAAACgAAAAoAAAAZAAAAGQAAAAAAAAAzMzMAAAAAABQAAAAUAAAAGQAAABkAAAAAAAAABcAAAAUAAAAAAAAAAAAAAD/fwAA/38AAAAAAAAJAAAABAAAAAAAAAAeAAAAaAAAAAAAAAAAAAAAAAAAAAAAAAAAAAAAECcAABAnAAAAAAAAAAAAAAAAAAAAAAAAAAAAAAAAAAAAAAAAAAAAABQAAAAAAAAAwMD/AAAAAABkAAAAMgAAAAAAAABkAAAAAAAAAH9/fwAKAAAAIgAAABgAAAAAAAAAAAAAAAAAAAAAAAAAAAAAAAAAAAAkAAAAJAAAAAAAAAAHAAAAAAAAAAAAAAAAAAAAAAAAAAAAAAAAAAAAf39/ACUAAABYAAAAAAAAAAAAAAAAAAAAAAAAAAAAAAAAAAAAAAAAAAAAAAAAAAAAAAAAAAAAAAA/AAAAAAAAAKCGAQAAAAAAAAAAAAAAAAAMAAAAAQAAAAAAAAAAAAAAAAAAAB8AAABUAAAA+/v+AAAAAAEAAAAAAAAAAAAAAAAAAAAAAAAAAAAAAAAAAAAAAAAAAAAAAAJ/f38AAAAAA8zMzADAwP8Af39/AAAAAAAAAAAAAAAAAAAAAAAAAAAAIQAAABgAAAAUAAAAuwMAAJYRAACQNAAAzSUAABAAAAAmAAAACAAAAP//////////"/>
               </a:ext>
             </a:extLst>
           </p:cNvSpPr>
@@ -3402,7 +3402,7 @@
             <a:spLocks noGrp="1" noChangeArrowheads="1"/>
             <a:extLst>
               <a:ext uri="smNativeData">
-                <pr:smNativeData xmlns:pr="smNativeData" xmlns="smNativeData" val="SMDATA_15_FUV5ZhMAAAAlAAAAZAAAAA0AAAAAkAAAAJAAAACQAAAAkAAAAAAAAAAAAAAAAAAAAAEAAABQAAAAAAAAAAAA4D8AAAAAAADgPwAAAAAAAOA/AAAAAAAA4D8AAAAAAADgPwAAAAAAAOA/AAAAAAAA4D8AAAAAAADgPwAAAAAAAOA/AAAAAAAA4D8CAAAAjAAAAAAAAAAAAAAAQoX0DP///wgAAAAAAAAAAAAAAAAAAAAAAAAAAAAAAAAAAAAAZAAAAAEAAABAAAAAAAAAAAAAAAAAAAAAAAAAAAAAAAAAAAAAAAAAAAAAAAAAAAAAAAAAAAAAAAAAAAAAAAAAAAAAAAAAAAAAAAAAAAAAAAAAAAAAAAAAAAAAAAAAAAAAFAAAADwAAAAAAAAAAAAAAAAAAAkUAAAAAQAAABQAAAAUAAAAFAAAAAEAAAAAAAAAZAAAAGQAAAAAAAAAZAAAAGQAAAAVAAAAYAAAAAAAAAAAAAAADwAAACADAAAAAAAAAAAAAAEAAACgMgAAVgcAAKr4//8BAAAAf39/AAEAAABkAAAAAAAAABQAAABAHwAAAAAAACYAAAAAAAAAwOD//wAAAAAmAAAAZAAAABYAAABMAAAAAAAAAAAAAAAEAAAAAAAAAAEAAABZWVkKAAAAACgAAAAoAAAAZAAAAGQAAAAAAAAAzMzMAAAAAABQAAAAUAAAAGQAAABkAAAAAAAAABcAAAAUAAAAAAAAAAAAAAD/fwAA/38AAAAAAAAJAAAABAAAAAAAAAAeAAAAaAAAAAAAAAAAAAAAAAAAAAAAAAAAAAAAECcAABAnAAAAAAAAAAAAAAAAAAAAAAAAAAAAAAAAAAAAAAAAAAAAABQAAAAAAAAAwMD/AAAAAABkAAAAMgAAAAAAAABkAAAAAAAAAH9/fwAKAAAAIgAAABgAAAAAAAAAAAAAAAAAAAAAAAAAAAAAAAAAAAAkAAAAJAAAAAAAAAAHAAAAAAAAAAAAAAAAAAAAAAAAAAAAAAAAAAAAf39/ACUAAABYAAAAAAAAAAAAAAAAAAAAAAAAAAAAAAAAAAAAAAAAAAAAAAAAAAAAAAAAAAAAAAA/AAAAAAAAAKCGAQAAAAAAAAAAAAAAAAAMAAAAAQAAAAAAAAAAAAAAAAAAAB8AAABUAAAAAAAABQAAAAEAAAAAAAAAAAAAAAAAAAAAAAAAAAAAAAAAAAAAAAAAAAAAAAJ/f38AAAAAA8zMzADAwP8Af39/AAAAAAAAAAAAAAAAAAAAAAAAAAAAIQAAABgAAAAUAAAAfAQAAIESAAC5NQAAuCYAABAAAAAmAAAACAAAAD2wAAAAAAAA"/>
+                <pr:smNativeData xmlns:pr="smNativeData" xmlns="smNativeData" val="SMDATA_15_9kV5ZhMAAAAlAAAAZAAAAA0AAAAAkAAAAJAAAACQAAAAkAAAAAAAAAAAAAAAAAAAAAEAAABQAAAAAAAAAAAA4D8AAAAAAADgPwAAAAAAAOA/AAAAAAAA4D8AAAAAAADgPwAAAAAAAOA/AAAAAAAA4D8AAAAAAADgPwAAAAAAAOA/AAAAAAAA4D8CAAAAjAAAAAAAAAAAAAAAQoX0DP///wgAAAAAAAAAAAAAAAAAAAAAAAAAAAAAAAAAAAAAZAAAAAEAAABAAAAAAAAAAAAAAAAAAAAAAAAAAAAAAAAAAAAAAAAAAAAAAAAAAAAAAAAAAAAAAAAAAAAAAAAAAAAAAAAAAAAAAAAAAAAAAAAAAAAAAAAAAAAAAAAAAAAAFAAAADwAAAAAAAAAAAAAAAAAAAkUAAAAAQAAABQAAAAUAAAAFAAAAAEAAAAAAAAAZAAAAGQAAAAAAAAAZAAAAGQAAAAVAAAAYAAAAAAAAAAAAAAADwAAACADAAAAAAAAAAAAAAEAAACgMgAAVgcAAKr4//8BAAAAf39/AAEAAABkAAAAAAAAABQAAABAHwAAAAAAACYAAAAAAAAAwOD//wAAAAAmAAAAZAAAABYAAABMAAAAAAAAAAAAAAAEAAAAAAAAAAEAAABZWVkKAAAAACgAAAAoAAAAZAAAAGQAAAAAAAAAzMzMAAAAAABQAAAAUAAAAGQAAABkAAAAAAAAABcAAAAUAAAAAAAAAAAAAAD/fwAA/38AAAAAAAAJAAAABAAAAAAAAAAeAAAAaAAAAAAAAAAAAAAAAAAAAAAAAAAAAAAAECcAABAnAAAAAAAAAAAAAAAAAAAAAAAAAAAAAAAAAAAAAAAAAAAAABQAAAAAAAAAwMD/AAAAAABkAAAAMgAAAAAAAABkAAAAAAAAAH9/fwAKAAAAIgAAABgAAAAAAAAAAAAAAAAAAAAAAAAAAAAAAAAAAAAkAAAAJAAAAAAAAAAHAAAAAAAAAAAAAAAAAAAAAAAAAAAAAAAAAAAAf39/ACUAAABYAAAAAAAAAAAAAAAAAAAAAAAAAAAAAAAAAAAAAAAAAAAAAAAAAAAAAAAAAAAAAAA/AAAAAAAAAKCGAQAAAAAAAAAAAAAAAAAMAAAAAQAAAAAAAAAAAAAAAAAAAB8AAABUAAAAAAAABQAAAAEAAAAAAAAAAAAAAAAAAAAAAAAAAAAAAAAAAAAAAAAAAAAAAAJ/f38AAAAAA8zMzADAwP8Af39/AAAAAAAAAAAAAAAAAAAAAAAAAAAAIQAAABgAAAAUAAAAfAQAAIESAAC5NQAAuCYAABAAAAAmAAAACAAAAD2wAAAAAAAA"/>
               </a:ext>
             </a:extLst>
           </p:cNvSpPr>
@@ -3585,7 +3585,7 @@
             <a:spLocks noGrp="1" noChangeArrowheads="1"/>
             <a:extLst>
               <a:ext uri="smNativeData">
-                <pr:smNativeData xmlns:pr="smNativeData" xmlns="smNativeData" val="SMDATA_15_FUV5ZhMAAAAlAAAAZAAAAA0AAAAAkAAAAJAAAACQAAAAkAAAAAAAAAAAAAAAAAAAAAEAAABQAAAAAAAAAAAA4D8AAAAAAADgPwAAAAAAAOA/AAAAAAAA4D8AAAAAAADgPwAAAAAAAOA/AAAAAAAA4D8AAAAAAADgPwAAAAAAAOA/AAAAAAAA4D8CAAAAjAAAAAAAAAAAAAAAQoX0DP///wgAAAAAAAAAAAAAAAAAAAAAAAAAAAAAAAAAAAAAZAAAAAEAAABAAAAAAAAAAAAAAAAAAAAAAAAAAAAAAAAAAAAAAAAAAAAAAAAAAAAAAAAAAAAAAAAAAAAAAAAAAAAAAAAAAAAAAAAAAAAAAAAAAAAAAAAAAAAAAAAAAAAAFAAAADwAAAAAAAAAAAAAAAAAAAkUAAAAAQAAABQAAAAUAAAAFAAAAAEAAAAAAAAAZAAAAGQAAAAAAAAAZAAAAGQAAAAVAAAAYAAAAAAAAAAAAAAADwAAACADAAAAAAAAAAAAAAEAAACgMgAAVgcAAKr4//8BAAAAf39/AAEAAABkAAAAAAAAABQAAABAHwAAAAAAACYAAAAAAAAAwOD//wAAAAAmAAAAZAAAABYAAABMAAAAAAAAAAAAAAAEAAAAAAAAAAEAAABZWVkKAAAAACgAAAAoAAAAZAAAAGQAAAAAAAAAzMzMAAAAAABQAAAAUAAAAGQAAABkAAAAAAAAABcAAAAUAAAAAAAAAAAAAAD/fwAA/38AAAAAAAAJAAAABAAAAAAAAAAeAAAAaAAAAAAAAAAAAAAAAAAAAAAAAAAAAAAAECcAABAnAAAAAAAAAAAAAAAAAAAAAAAAAAAAAAAAAAAAAAAAAAAAABQAAAAAAAAAwMD/AAAAAABkAAAAMgAAAAAAAABkAAAAAAAAAH9/fwAKAAAAIgAAABgAAAAAAAAAAAAAAAAAAAAAAAAAAAAAAAAAAAAkAAAAJAAAAAAAAAAHAAAAAAAAAAAAAAAAAAAAAAAAAAAAAAAAAAAAf39/ACUAAABYAAAAAAAAAAAAAAAAAAAAAAAAAAAAAAAAAAAAAAAAAAAAAAAAAAAAAAAAAAAAAAA/AAAAAAAAAKCGAQAAAAAAAAAAAAAAAAAMAAAAAQAAAAAAAAAAAAAAAAAAAB8AAABUAAAAAAAABQAAAAEAAAAAAAAAAAAAAAAAAAAAAAAAAAAAAAAAAAAAAAAAAAAAAAJ/f38AAAAAA8zMzADAwP8Af39/AAAAAAAAAAAAAAAAAAAAAAAAAAAAIQAAABgAAAAUAAAAQwMAAA4LAABBNQAAlhEAABAAAAAmAAAACAAAAD2wAAAAAAAA"/>
+                <pr:smNativeData xmlns:pr="smNativeData" xmlns="smNativeData" val="SMDATA_15_9kV5ZhMAAAAlAAAAZAAAAA0AAAAAkAAAAJAAAACQAAAAkAAAAAAAAAAAAAAAAAAAAAEAAABQAAAAAAAAAAAA4D8AAAAAAADgPwAAAAAAAOA/AAAAAAAA4D8AAAAAAADgPwAAAAAAAOA/AAAAAAAA4D8AAAAAAADgPwAAAAAAAOA/AAAAAAAA4D8CAAAAjAAAAAAAAAAAAAAAQoX0DP///wgAAAAAAAAAAAAAAAAAAAAAAAAAAAAAAAAAAAAAZAAAAAEAAABAAAAAAAAAAAAAAAAAAAAAAAAAAAAAAAAAAAAAAAAAAAAAAAAAAAAAAAAAAAAAAAAAAAAAAAAAAAAAAAAAAAAAAAAAAAAAAAAAAAAAAAAAAAAAAAAAAAAAFAAAADwAAAAAAAAAAAAAAAAAAAkUAAAAAQAAABQAAAAUAAAAFAAAAAEAAAAAAAAAZAAAAGQAAAAAAAAAZAAAAGQAAAAVAAAAYAAAAAAAAAAAAAAADwAAACADAAAAAAAAAAAAAAEAAACgMgAAVgcAAKr4//8BAAAAf39/AAEAAABkAAAAAAAAABQAAABAHwAAAAAAACYAAAAAAAAAwOD//wAAAAAmAAAAZAAAABYAAABMAAAAAAAAAAAAAAAEAAAAAAAAAAEAAABZWVkKAAAAACgAAAAoAAAAZAAAAGQAAAAAAAAAzMzMAAAAAABQAAAAUAAAAGQAAABkAAAAAAAAABcAAAAUAAAAAAAAAAAAAAD/fwAA/38AAAAAAAAJAAAABAAAAAAAAAAeAAAAaAAAAAAAAAAAAAAAAAAAAAAAAAAAAAAAECcAABAnAAAAAAAAAAAAAAAAAAAAAAAAAAAAAAAAAAAAAAAAAAAAABQAAAAAAAAAwMD/AAAAAABkAAAAMgAAAAAAAABkAAAAAAAAAH9/fwAKAAAAIgAAABgAAAAAAAAAAAAAAAAAAAAAAAAAAAAAAAAAAAAkAAAAJAAAAAAAAAAHAAAAAAAAAAAAAAAAAAAAAAAAAAAAAAAAAAAAf39/ACUAAABYAAAAAAAAAAAAAAAAAAAAAAAAAAAAAAAAAAAAAAAAAAAAAAAAAAAAAAAAAAAAAAA/AAAAAAAAAKCGAQAAAAAAAAAAAAAAAAAMAAAAAQAAAAAAAAAAAAAAAAAAAB8AAABUAAAAAAAABQAAAAEAAAAAAAAAAAAAAAAAAAAAAAAAAAAAAAAAAAAAAAAAAAAAAAJ/f38AAAAAA8zMzADAwP8Af39/AAAAAAAAAAAAAAAAAAAAAAAAAAAAIQAAABgAAAAUAAAAQwMAAA4LAABBNQAAlhEAABAAAAAmAAAACAAAAD2wAAAAAAAA"/>
               </a:ext>
             </a:extLst>
           </p:cNvSpPr>
@@ -3797,7 +3797,7 @@
             <a:spLocks noGrp="1" noChangeArrowheads="1"/>
             <a:extLst>
               <a:ext uri="smNativeData">
-                <pr:smNativeData xmlns:pr="smNativeData" xmlns="smNativeData" val="SMDATA_15_FUV5ZhMAAAAlAAAAZAAAAA0AAAAAkAAAAJAAAACQAAAAkAAAAAAAAAAAAAAAAAAAAAEAAABQAAAAAAAAAAAA4D8AAAAAAADgPwAAAAAAAOA/AAAAAAAA4D8AAAAAAADgPwAAAAAAAOA/AAAAAAAA4D8AAAAAAADgPwAAAAAAAOA/AAAAAAAA4D8CAAAAjAAAAAAAAAAAAAAAQoX0DP///wgAAAAAAAAAAAAAAAAAAAAAAAAAAAAAAAAAAAAAZAAAAAEAAABAAAAAAAAAAAAAAAAAAAAAAAAAAAAAAAAAAAAAAAAAAAAAAAAAAAAAAAAAAAAAAAAAAAAAAAAAAAAAAAAAAAAAAAAAAAAAAAAAAAAAAAAAAAAAAAAAAAAAFAAAADwAAAAAAAAAAAAAAAAAAAkUAAAAAQAAABQAAAAUAAAAFAAAAAEAAAAAAAAAZAAAAGQAAAAAAAAAZAAAAGQAAAAVAAAAYAAAAAAAAAAAAAAADwAAACADAAAAAAAAAAAAAAEAAACgMgAAVgcAAKr4//8BAAAAf39/AAEAAABkAAAAAAAAABQAAABAHwAAAAAAACYAAAAAAAAAwOD//wAAAAAmAAAAZAAAABYAAABMAAAAAAAAAAAAAAAEAAAAAAAAAAEAAABZWVkKAAAAACgAAAAoAAAAZAAAAGQAAAAAAAAAzMzMAAAAAABQAAAAUAAAAGQAAABkAAAAAAAAABcAAAAUAAAAAAAAAAAAAAD/fwAA/38AAAAAAAAJAAAABAAAAAAAAAAeAAAAaAAAAAAAAAAAAAAAAAAAAAAAAAAAAAAAECcAABAnAAAAAAAAAAAAAAAAAAAAAAAAAAAAAAAAAAAAAAAAAAAAABQAAAAAAAAAwMD/AAAAAABkAAAAMgAAAAAAAABkAAAAAAAAAH9/fwAKAAAAIgAAABgAAAAAAAAAAAAAAAAAAAAAAAAAAAAAAAAAAAAkAAAAJAAAAAAAAAAHAAAAAAAAAAAAAAAAAAAAAAAAAAAAAAAAAAAAf39/ACUAAABYAAAAAAAAAAAAAAAAAAAAAAAAAAAAAAAAAAAAAAAAAAAAAAAAAAAAAAAAAAAAAAA/AAAAAAAAAKCGAQAAAAAAAAAAAAAAAAAMAAAAAQAAAAAAAAAAAAAAAAAAAB8AAABUAAAAAAAABQAAAAEAAAAAAAAAAAAAAAAAAAAAAAAAAAAAAAAAAAAAAAAAAAAAAAJ/f38AAAAAA8zMzADAwP8Af39/AAAAAAAAAAAAAAAAAAAAAAAAAAAAIQAAABgAAAAUAAAAFAMAALYCAAB/NwAAvwoAABAAAAAmAAAACAAAADywAAAAAAAA"/>
+                <pr:smNativeData xmlns:pr="smNativeData" xmlns="smNativeData" val="SMDATA_15_9kV5ZhMAAAAlAAAAZAAAAA0AAAAAkAAAAJAAAACQAAAAkAAAAAAAAAAAAAAAAAAAAAEAAABQAAAAAAAAAAAA4D8AAAAAAADgPwAAAAAAAOA/AAAAAAAA4D8AAAAAAADgPwAAAAAAAOA/AAAAAAAA4D8AAAAAAADgPwAAAAAAAOA/AAAAAAAA4D8CAAAAjAAAAAAAAAAAAAAAQoX0DP///wgAAAAAAAAAAAAAAAAAAAAAAAAAAAAAAAAAAAAAZAAAAAEAAABAAAAAAAAAAAAAAAAAAAAAAAAAAAAAAAAAAAAAAAAAAAAAAAAAAAAAAAAAAAAAAAAAAAAAAAAAAAAAAAAAAAAAAAAAAAAAAAAAAAAAAAAAAAAAAAAAAAAAFAAAADwAAAAAAAAAAAAAAAAAAAkUAAAAAQAAABQAAAAUAAAAFAAAAAEAAAAAAAAAZAAAAGQAAAAAAAAAZAAAAGQAAAAVAAAAYAAAAAAAAAAAAAAADwAAACADAAAAAAAAAAAAAAEAAACgMgAAVgcAAKr4//8BAAAAf39/AAEAAABkAAAAAAAAABQAAABAHwAAAAAAACYAAAAAAAAAwOD//wAAAAAmAAAAZAAAABYAAABMAAAAAAAAAAAAAAAEAAAAAAAAAAEAAABZWVkKAAAAACgAAAAoAAAAZAAAAGQAAAAAAAAAzMzMAAAAAABQAAAAUAAAAGQAAABkAAAAAAAAABcAAAAUAAAAAAAAAAAAAAD/fwAA/38AAAAAAAAJAAAABAAAAAAAAAAeAAAAaAAAAAAAAAAAAAAAAAAAAAAAAAAAAAAAECcAABAnAAAAAAAAAAAAAAAAAAAAAAAAAAAAAAAAAAAAAAAAAAAAABQAAAAAAAAAwMD/AAAAAABkAAAAMgAAAAAAAABkAAAAAAAAAH9/fwAKAAAAIgAAABgAAAAAAAAAAAAAAAAAAAAAAAAAAAAAAAAAAAAkAAAAJAAAAAAAAAAHAAAAAAAAAAAAAAAAAAAAAAAAAAAAAAAAAAAAf39/ACUAAABYAAAAAAAAAAAAAAAAAAAAAAAAAAAAAAAAAAAAAAAAAAAAAAAAAAAAAAAAAAAAAAA/AAAAAAAAAKCGAQAAAAAAAAAAAAAAAAAMAAAAAQAAAAAAAAAAAAAAAAAAAB8AAABUAAAAAAAABQAAAAEAAAAAAAAAAAAAAAAAAAAAAAAAAAAAAAAAAAAAAAAAAAAAAAJ/f38AAAAAA8zMzADAwP8Af39/AAAAAAAAAAAAAAAAAAAAAAAAAAAAIQAAABgAAAAUAAAAFAMAALYCAAB/NwAAvwoAABAAAAAmAAAACAAAADywAAAAAAAA"/>
               </a:ext>
             </a:extLst>
           </p:cNvSpPr>
@@ -3906,7 +3906,7 @@
           <p:cNvSpPr>
             <a:extLst>
               <a:ext uri="smNativeData">
-                <pr:smNativeData xmlns:pr="smNativeData" xmlns="smNativeData" val="SMDATA_15_FUV5ZhMAAAAlAAAAZAAAAA0AAAAAkAAAAJAAAACQAAAAkAAAAAAAAAABAAAAAAAAAAEAAABQAAAAAAAAAAAA4D8AAAAAAADgPwAAAAAAAOA/AAAAAAAA4D8AAAAAAADgPwAAAAAAAOA/AAAAAAAA4D8AAAAAAADgPwAAAAAAAOA/AAAAAAAA4D8CAAAAjAAAAAEAAAAAAAAA+/v+AP///wgAAAAAAAAAAAAAAAAAAAAAAAAAAAAAAAAAAAAAeAAAAAEAAABAAAAAAAAAAAAAAABaAAAAAAAAAAAAAAAAAAAAAAAAAAAAAAAAAAAAAAAAAAAAAAAAAAAAAAAAAAAAAAAAAAAAAAAAAAAAAAAAAAAAAAAAAAAAAAAAAAAAFAAAADwAAAAAAAAAAAAAAAAAAAkUAAAAAQAAABQAAAAUAAAAFAAAAAEAAAAAAAAAZAAAAGQAAAAAAAAAZAAAAGQAAAAVAAAAYAAAAAAAAAAAAAAADwAAACADAAAAAAAAAAAAAAEAAACgMgAAVgcAAKr4//8BAAAAf39/AAEAAABkAAAAAAAAABQAAABAHwAAAAAAACYAAAAAAAAAwOD//wAAAAAmAAAAZAAAABYAAABMAAAAAAAAAAAAAAAEAAAAAAAAAAEAAABZWVkKAAAAACgAAAAoAAAAZAAAAGQAAAAAAAAAzMzMAAAAAABQAAAAUAAAAGQAAABkAAAAAAAAABcAAAAUAAAAAAAAAAAAAAD/fwAA/38AAAAAAAAJAAAABAAAAAAAAAAeAAAAaAAAAAAAAAAAAAAAAAAAAAAAAAAAAAAAECcAABAnAAAAAAAAAAAAAAAAAAAAAAAAAAAAAAAAAAAAAAAAAAAAABQAAAAAAAAAwMD/AAAAAABkAAAAMgAAAAAAAABkAAAAAAAAAH9/fwAKAAAAIgAAABgAAAAAAAAAAAAAAAAAAAAAAAAAAAAAAAAAAAAkAAAAJAAAAAAAAAAHAAAAAAAAAAAAAAAAAAAAAAAAAAAAAAAAAAAAf39/ACUAAABYAAAAAAAAAAAAAAAAAAAAAAAAAAAAAAAAAAAAAAAAAAAAAAAAAAAAAAAAAAAAAAA/AAAAAAAAAKCGAQAAAAAAAAAAAAAAAAAMAAAAAQAAAAAAAAAAAAAAAAAAAB8AAABUAAAA+/v+AAAAAAEAAAAAAAAAAAAAAAAAAAAAAAAAAAAAAAAAAAAAAAAAAAAAAAJ/f38AAAAAA8zMzADAwP8Af39/AAAAAAAAAAAAAAAAAAAAAAAAAAAAIQAAABgAAAAUAAAAOwIAAPIJAABxHwAALycAABAAAAAmAAAACAAAAP//////////"/>
+                <pr:smNativeData xmlns:pr="smNativeData" xmlns="smNativeData" val="SMDATA_15_9kV5ZhMAAAAlAAAAZAAAAA0AAAAAkAAAAJAAAACQAAAAkAAAAAAAAAABAAAAAAAAAAEAAABQAAAAAAAAAAAA4D8AAAAAAADgPwAAAAAAAOA/AAAAAAAA4D8AAAAAAADgPwAAAAAAAOA/AAAAAAAA4D8AAAAAAADgPwAAAAAAAOA/AAAAAAAA4D8CAAAAjAAAAAEAAAAAAAAA+/v+AP///wgAAAAAAAAAAAAAAAAAAAAAAAAAAAAAAAAAAAAAeAAAAAEAAABAAAAAAAAAAAAAAABaAAAAAAAAAAAAAAAAAAAAAAAAAAAAAAAAAAAAAAAAAAAAAAAAAAAAAAAAAAAAAAAAAAAAAAAAAAAAAAAAAAAAAAAAAAAAAAAAAAAAFAAAADwAAAAAAAAAAAAAAAAAAAkUAAAAAQAAABQAAAAUAAAAFAAAAAEAAAAAAAAAZAAAAGQAAAAAAAAAZAAAAGQAAAAVAAAAYAAAAAAAAAAAAAAADwAAACADAAAAAAAAAAAAAAEAAACgMgAAVgcAAKr4//8BAAAAf39/AAEAAABkAAAAAAAAABQAAABAHwAAAAAAACYAAAAAAAAAwOD//wAAAAAmAAAAZAAAABYAAABMAAAAAAAAAAAAAAAEAAAAAAAAAAEAAABZWVkKAAAAACgAAAAoAAAAZAAAAGQAAAAAAAAAzMzMAAAAAABQAAAAUAAAAGQAAABkAAAAAAAAABcAAAAUAAAAAAAAAAAAAAD/fwAA/38AAAAAAAAJAAAABAAAAAAAAAAeAAAAaAAAAAAAAAAAAAAAAAAAAAAAAAAAAAAAECcAABAnAAAAAAAAAAAAAAAAAAAAAAAAAAAAAAAAAAAAAAAAAAAAABQAAAAAAAAAwMD/AAAAAABkAAAAMgAAAAAAAABkAAAAAAAAAH9/fwAKAAAAIgAAABgAAAAAAAAAAAAAAAAAAAAAAAAAAAAAAAAAAAAkAAAAJAAAAAAAAAAHAAAAAAAAAAAAAAAAAAAAAAAAAAAAAAAAAAAAf39/ACUAAABYAAAAAAAAAAAAAAAAAAAAAAAAAAAAAAAAAAAAAAAAAAAAAAAAAAAAAAAAAAAAAAA/AAAAAAAAAKCGAQAAAAAAAAAAAAAAAAAMAAAAAQAAAAAAAAAAAAAAAAAAAB8AAABUAAAA+/v+AAAAAAEAAAAAAAAAAAAAAAAAAAAAAAAAAAAAAAAAAAAAAAAAAAAAAAJ/f38AAAAAA8zMzADAwP8Af39/AAAAAAAAAAAAAAAAAAAAAAAAAAAAIQAAABgAAAAUAAAAOwIAAPIJAABxHwAALycAABAAAAAmAAAACAAAAP//////////"/>
               </a:ext>
             </a:extLst>
           </p:cNvSpPr>
@@ -3951,7 +3951,7 @@
             <a:spLocks noGrp="1" noChangeArrowheads="1"/>
             <a:extLst>
               <a:ext uri="smNativeData">
-                <pr:smNativeData xmlns:pr="smNativeData" xmlns="smNativeData" val="SMDATA_15_FUV5ZhMAAAAlAAAAZAAAAA0AAAAAkAAAAJAAAACQAAAAkAAAAAAAAAAAAAAAAAAAAAEAAABQAAAAAAAAAAAA4D8AAAAAAADgPwAAAAAAAOA/AAAAAAAA4D8AAAAAAADgPwAAAAAAAOA/AAAAAAAA4D8AAAAAAADgPwAAAAAAAOA/AAAAAAAA4D8CAAAAjAAAAAAAAAAAAAAAQoX0DP///wgAAAAAAAAAAAAAAAAAAAAAAAAAAAAAAAAAAAAAZAAAAAEAAABAAAAAAAAAAAAAAAAAAAAAAAAAAAAAAAAAAAAAAAAAAAAAAAAAAAAAAAAAAAAAAAAAAAAAAAAAAAAAAAAAAAAAAAAAAAAAAAAAAAAAAAAAAAAAAAAAAAAAFAAAADwAAAAAAAAAAAAAAAAAAAkUAAAAAQAAABQAAAAUAAAAFAAAAAEAAAAAAAAAZAAAAGQAAAAAAAAAZAAAAGQAAAAVAAAAYAAAAAAAAAAAAAAADwAAACADAAAAAAAAAAAAAAEAAACgMgAAVgcAAKr4//8BAAAAf39/AAEAAABkAAAAAAAAABQAAABAHwAAAAAAACYAAAAAAAAAwOD//wAAAAAmAAAAZAAAABYAAABMAAAAAAAAAAAAAAAEAAAAAAAAAAEAAABZWVkKAAAAACgAAAAoAAAAZAAAAGQAAAAAAAAAzMzMAAAAAABQAAAAUAAAAGQAAABkAAAAAAAAABcAAAAUAAAAAAAAAAAAAAD/fwAA/38AAAAAAAAJAAAABAAAAAAAAAAeAAAAaAAAAAAAAAAAAAAAAAAAAAAAAAAAAAAAECcAABAnAAAAAAAAAAAAAAAAAAAAAAAAAAAAAAAAAAAAAAAAAAAAABQAAAAAAAAAwMD/AAAAAABkAAAAMgAAAAAAAABkAAAAAAAAAH9/fwAKAAAAIgAAABgAAAAAAAAAAAAAAAAAAAAAAAAAAAAAAAAAAAAkAAAAJAAAAAAAAAAHAAAAAAAAAAAAAAAAAAAAAAAAAAAAAAAAAAAAf39/ACUAAABYAAAAAAAAAAAAAAAAAAAAAAAAAAAAAAAAAAAAAAAAAAAAAAAAAAAAAAAAAAAAAAA/AAAAAAAAAKCGAQAAAAAAAAAAAAAAAAAMAAAAAQAAAAAAAAAAAAAAAAAAAB8AAABUAAAAAAAABQAAAAEAAAAAAAAAAAAAAAAAAAAAAAAAAAAAAAAAAAAAAAAAAAAAAAJ/f38AAAAAA8zMzADAwP8Af39/AAAAAAAAAAAAAAAAAAAAAAAAAAAAIQAAABgAAAAUAAAAFAMAANkKAABSHgAAMCcAABAAAAAmAAAACAAAAD2wAAAAAAAA"/>
+                <pr:smNativeData xmlns:pr="smNativeData" xmlns="smNativeData" val="SMDATA_15_9kV5ZhMAAAAlAAAAZAAAAA0AAAAAkAAAAJAAAACQAAAAkAAAAAAAAAAAAAAAAAAAAAEAAABQAAAAAAAAAAAA4D8AAAAAAADgPwAAAAAAAOA/AAAAAAAA4D8AAAAAAADgPwAAAAAAAOA/AAAAAAAA4D8AAAAAAADgPwAAAAAAAOA/AAAAAAAA4D8CAAAAjAAAAAAAAAAAAAAAQoX0DP///wgAAAAAAAAAAAAAAAAAAAAAAAAAAAAAAAAAAAAAZAAAAAEAAABAAAAAAAAAAAAAAAAAAAAAAAAAAAAAAAAAAAAAAAAAAAAAAAAAAAAAAAAAAAAAAAAAAAAAAAAAAAAAAAAAAAAAAAAAAAAAAAAAAAAAAAAAAAAAAAAAAAAAFAAAADwAAAAAAAAAAAAAAAAAAAkUAAAAAQAAABQAAAAUAAAAFAAAAAEAAAAAAAAAZAAAAGQAAAAAAAAAZAAAAGQAAAAVAAAAYAAAAAAAAAAAAAAADwAAACADAAAAAAAAAAAAAAEAAACgMgAAVgcAAKr4//8BAAAAf39/AAEAAABkAAAAAAAAABQAAABAHwAAAAAAACYAAAAAAAAAwOD//wAAAAAmAAAAZAAAABYAAABMAAAAAAAAAAAAAAAEAAAAAAAAAAEAAABZWVkKAAAAACgAAAAoAAAAZAAAAGQAAAAAAAAAzMzMAAAAAABQAAAAUAAAAGQAAABkAAAAAAAAABcAAAAUAAAAAAAAAAAAAAD/fwAA/38AAAAAAAAJAAAABAAAAAAAAAAeAAAAaAAAAAAAAAAAAAAAAAAAAAAAAAAAAAAAECcAABAnAAAAAAAAAAAAAAAAAAAAAAAAAAAAAAAAAAAAAAAAAAAAABQAAAAAAAAAwMD/AAAAAABkAAAAMgAAAAAAAABkAAAAAAAAAH9/fwAKAAAAIgAAABgAAAAAAAAAAAAAAAAAAAAAAAAAAAAAAAAAAAAkAAAAJAAAAAAAAAAHAAAAAAAAAAAAAAAAAAAAAAAAAAAAAAAAAAAAf39/ACUAAABYAAAAAAAAAAAAAAAAAAAAAAAAAAAAAAAAAAAAAAAAAAAAAAAAAAAAAAAAAAAAAAA/AAAAAAAAAKCGAQAAAAAAAAAAAAAAAAAMAAAAAQAAAAAAAAAAAAAAAAAAAB8AAABUAAAAAAAABQAAAAEAAAAAAAAAAAAAAAAAAAAAAAAAAAAAAAAAAAAAAAAAAAAAAAJ/f38AAAAAA8zMzADAwP8Af39/AAAAAAAAAAAAAAAAAAAAAAAAAAAAIQAAABgAAAAUAAAAFAMAANkKAABSHgAAMCcAABAAAAAmAAAACAAAAD2wAAAAAAAA"/>
               </a:ext>
             </a:extLst>
           </p:cNvSpPr>
@@ -4106,7 +4106,7 @@
             <a:spLocks noGrp="1" noChangeArrowheads="1"/>
             <a:extLst>
               <a:ext uri="smNativeData">
-                <pr:smNativeData xmlns:pr="smNativeData" xmlns="smNativeData" val="SMDATA_15_FUV5ZhMAAAAlAAAAZAAAAA0AAAAAkAAAAJAAAACQAAAAkAAAAAAAAAAAAAAAAAAAAAEAAABQAAAAAAAAAAAA4D8AAAAAAADgPwAAAAAAAOA/AAAAAAAA4D8AAAAAAADgPwAAAAAAAOA/AAAAAAAA4D8AAAAAAADgPwAAAAAAAOA/AAAAAAAA4D8CAAAAjAAAAAAAAAAAAAAAQoX0DP///wgAAAAAAAAAAAAAAAAAAAAAAAAAAAAAAAAAAAAAZAAAAAEAAABAAAAAAAAAAAAAAAAAAAAAAAAAAAAAAAAAAAAAAAAAAAAAAAAAAAAAAAAAAAAAAAAAAAAAAAAAAAAAAAAAAAAAAAAAAAAAAAAAAAAAAAAAAAAAAAAAAAAAFAAAADwAAAAAAAAAAAAAAAAAAAkUAAAAAQAAABQAAAAUAAAAFAAAAAEAAAAAAAAAZAAAAGQAAAAAAAAAZAAAAGQAAAAVAAAAYAAAAAAAAAAAAAAADwAAACADAAAAAAAAAAAAAAEAAACgMgAAVgcAAKr4//8BAAAAf39/AAEAAABkAAAAAAAAABQAAABAHwAAAAAAACYAAAAAAAAAwOD//wAAAAAmAAAAZAAAABYAAABMAAAAAAAAAAAAAAAEAAAAAAAAAAEAAABZWVkKAAAAACgAAAAoAAAAZAAAAGQAAAAAAAAAzMzMAAAAAABQAAAAUAAAAGQAAABkAAAAAAAAABcAAAAUAAAAAAAAAAAAAAD/fwAA/38AAAAAAAAJAAAABAAAAAAAAAAeAAAAaAAAAAAAAAAAAAAAAAAAAAAAAAAAAAAAECcAABAnAAAAAAAAAAAAAAAAAAAAAAAAAAAAAAAAAAAAAAAAAAAAABQAAAAAAAAAwMD/AAAAAABkAAAAMgAAAAAAAABkAAAAAAAAAH9/fwAKAAAAIgAAABgAAAAAAAAAAAAAAAAAAAAAAAAAAAAAAAAAAAAkAAAAJAAAAAAAAAAHAAAAAAAAAAAAAAAAAAAAAAAAAAAAAAAAAAAAf39/ACUAAABYAAAAAAAAAAAAAAAAAAAAAAAAAAAAAAAAAAAAAAAAAAAAAAAAAAAAAAAAAAAAAAA/AAAAAAAAAKCGAQAAAAAAAAAAAAAAAAAMAAAAAQAAAAAAAAAAAAAAAAAAAB8AAABUAAAAAAAABQAAAAEAAAAAAAAAAAAAAAAAAAAAAAAAAAAAAAAAAAAAAAAAAAAAAAJ/f38AAAAAA8zMzADAwP8Af39/AAAAAAAAAAAAAAAAAAAAAAAAAAAAIQAAABgAAAAUAAAALCIAANkKAACPNQAAmCUAABAAAAAmAAAACAAAAD2wAAAAAAAA"/>
+                <pr:smNativeData xmlns:pr="smNativeData" xmlns="smNativeData" val="SMDATA_15_9kV5ZhMAAAAlAAAAZAAAAA0AAAAAkAAAAJAAAACQAAAAkAAAAAAAAAAAAAAAAAAAAAEAAABQAAAAAAAAAAAA4D8AAAAAAADgPwAAAAAAAOA/AAAAAAAA4D8AAAAAAADgPwAAAAAAAOA/AAAAAAAA4D8AAAAAAADgPwAAAAAAAOA/AAAAAAAA4D8CAAAAjAAAAAAAAAAAAAAAQoX0DP///wgAAAAAAAAAAAAAAAAAAAAAAAAAAAAAAAAAAAAAZAAAAAEAAABAAAAAAAAAAAAAAAAAAAAAAAAAAAAAAAAAAAAAAAAAAAAAAAAAAAAAAAAAAAAAAAAAAAAAAAAAAAAAAAAAAAAAAAAAAAAAAAAAAAAAAAAAAAAAAAAAAAAAFAAAADwAAAAAAAAAAAAAAAAAAAkUAAAAAQAAABQAAAAUAAAAFAAAAAEAAAAAAAAAZAAAAGQAAAAAAAAAZAAAAGQAAAAVAAAAYAAAAAAAAAAAAAAADwAAACADAAAAAAAAAAAAAAEAAACgMgAAVgcAAKr4//8BAAAAf39/AAEAAABkAAAAAAAAABQAAABAHwAAAAAAACYAAAAAAAAAwOD//wAAAAAmAAAAZAAAABYAAABMAAAAAAAAAAAAAAAEAAAAAAAAAAEAAABZWVkKAAAAACgAAAAoAAAAZAAAAGQAAAAAAAAAzMzMAAAAAABQAAAAUAAAAGQAAABkAAAAAAAAABcAAAAUAAAAAAAAAAAAAAD/fwAA/38AAAAAAAAJAAAABAAAAAAAAAAeAAAAaAAAAAAAAAAAAAAAAAAAAAAAAAAAAAAAECcAABAnAAAAAAAAAAAAAAAAAAAAAAAAAAAAAAAAAAAAAAAAAAAAABQAAAAAAAAAwMD/AAAAAABkAAAAMgAAAAAAAABkAAAAAAAAAH9/fwAKAAAAIgAAABgAAAAAAAAAAAAAAAAAAAAAAAAAAAAAAAAAAAAkAAAAJAAAAAAAAAAHAAAAAAAAAAAAAAAAAAAAAAAAAAAAAAAAAAAAf39/ACUAAABYAAAAAAAAAAAAAAAAAAAAAAAAAAAAAAAAAAAAAAAAAAAAAAAAAAAAAAAAAAAAAAA/AAAAAAAAAKCGAQAAAAAAAAAAAAAAAAAMAAAAAQAAAAAAAAAAAAAAAAAAAB8AAABUAAAAAAAABQAAAAEAAAAAAAAAAAAAAAAAAAAAAAAAAAAAAAAAAAAAAAAAAAAAAAJ/f38AAAAAA8zMzADAwP8Af39/AAAAAAAAAAAAAAAAAAAAAAAAAAAAIQAAABgAAAAUAAAALCIAANkKAACPNQAAmCUAABAAAAAmAAAACAAAAD2wAAAAAAAA"/>
               </a:ext>
             </a:extLst>
           </p:cNvSpPr>
@@ -4318,7 +4318,7 @@
             <a:spLocks noGrp="1" noChangeArrowheads="1"/>
             <a:extLst>
               <a:ext uri="smNativeData">
-                <pr:smNativeData xmlns:pr="smNativeData" xmlns="smNativeData" val="SMDATA_15_FUV5ZhMAAAAlAAAAZAAAAA0AAAAAkAAAAJAAAACQAAAAkAAAAAAAAAABAAAAAAAAAAEAAABQAAAAAAAAAAAA4D8AAAAAAADgPwAAAAAAAOA/AAAAAAAA4D8AAAAAAADgPwAAAAAAAOA/AAAAAAAA4D8AAAAAAADgPwAAAAAAAOA/AAAAAAAA4D8CAAAAjAAAAAAAAAAAAAAAQoX0DP///wgAAAAAAAAAAAAAAAAAAAAAAAAAAAAAAAAAAAAAZAAAAAEAAABAAAAAAAAAAAAAAAAAAAAAAAAAAAAAAAAAAAAAAAAAAAAAAAAAAAAAAAAAAAAAAAAAAAAAAAAAAAAAAAAAAAAAAAAAAAAAAAAAAAAAAAAAAAAAAAAAAAAAFAAAADwAAAAAAAAAAAAAAAAAAAkUAAAAAQAAABQAAAAUAAAAFAAAAAEAAAAAAAAAZAAAAGQAAAAAAAAAZAAAAGQAAAAVAAAAYAAAAAAAAAAAAAAADwAAACADAAAAAAAAAAAAAAEAAACgMgAAVgcAAKr4//8BAAAAf39/AAEAAABkAAAAAAAAABQAAABAHwAAAAAAACYAAAAAAAAAwOD//wAAAAAmAAAAZAAAABYAAABMAAAAAAAAAAAAAAAEAAAAAAAAAAEAAABZWVkKAAAAACgAAAAoAAAAZAAAAGQAAAAAAAAAzMzMAAAAAABQAAAAUAAAAGQAAABkAAAAAAAAABcAAAAUAAAAAAAAAAAAAAD/fwAA/38AAAAAAAAJAAAABAAAAAAAAAAeAAAAaAAAAAAAAAAAAAAAAAAAAAAAAAAAAAAAECcAABAnAAAAAAAAAAAAAAAAAAAAAAAAAAAAAAAAAAAAAAAAAAAAABQAAAAAAAAAwMD/AAAAAABkAAAAMgAAAAAAAABkAAAAAAAAAH9/fwAKAAAAIgAAABgAAAAAAAAAAAAAAAAAAAAAAAAAAAAAAAAAAAAkAAAAJAAAAAAAAAAHAAAAAAAAAAAAAAAAAAAAAAAAAAAAAAAAAAAAf39/ACUAAABYAAAAAAAAAAAAAAAAAAAAAAAAAAAAAAAAAAAAAAAAAAAAAAAAAAAAAAAAAAAAAAA/AAAAAAAAAKCGAQAAAAAAAAAAAAAAAAAMAAAAAQAAAAAAAAAAAAAAAAAAAB8AAABUAAAAAAAABQAAAAEAAAAAAAAAAAAAAAAAAAAAAAAAAAAAAAAAAAAAAAAAAAAAAAJ/f38AAAAAA8zMzADAwP8Af39/AAAAAAAAAAAAAAAAAAAAAAAAAAAAIQAAABgAAAAUAAAAFAMAAEoPAADlMwAAMhYAABAAAAAmAAAACAAAAL2wAAAAAAAA"/>
+                <pr:smNativeData xmlns:pr="smNativeData" xmlns="smNativeData" val="SMDATA_15_9kV5ZhMAAAAlAAAAZAAAAA0AAAAAkAAAAJAAAACQAAAAkAAAAAAAAAABAAAAAAAAAAEAAABQAAAAAAAAAAAA4D8AAAAAAADgPwAAAAAAAOA/AAAAAAAA4D8AAAAAAADgPwAAAAAAAOA/AAAAAAAA4D8AAAAAAADgPwAAAAAAAOA/AAAAAAAA4D8CAAAAjAAAAAAAAAAAAAAAQoX0DP///wgAAAAAAAAAAAAAAAAAAAAAAAAAAAAAAAAAAAAAZAAAAAEAAABAAAAAAAAAAAAAAAAAAAAAAAAAAAAAAAAAAAAAAAAAAAAAAAAAAAAAAAAAAAAAAAAAAAAAAAAAAAAAAAAAAAAAAAAAAAAAAAAAAAAAAAAAAAAAAAAAAAAAFAAAADwAAAAAAAAAAAAAAAAAAAkUAAAAAQAAABQAAAAUAAAAFAAAAAEAAAAAAAAAZAAAAGQAAAAAAAAAZAAAAGQAAAAVAAAAYAAAAAAAAAAAAAAADwAAACADAAAAAAAAAAAAAAEAAACgMgAAVgcAAKr4//8BAAAAf39/AAEAAABkAAAAAAAAABQAAABAHwAAAAAAACYAAAAAAAAAwOD//wAAAAAmAAAAZAAAABYAAABMAAAAAAAAAAAAAAAEAAAAAAAAAAEAAABZWVkKAAAAACgAAAAoAAAAZAAAAGQAAAAAAAAAzMzMAAAAAABQAAAAUAAAAGQAAABkAAAAAAAAABcAAAAUAAAAAAAAAAAAAAD/fwAA/38AAAAAAAAJAAAABAAAAAAAAAAeAAAAaAAAAAAAAAAAAAAAAAAAAAAAAAAAAAAAECcAABAnAAAAAAAAAAAAAAAAAAAAAAAAAAAAAAAAAAAAAAAAAAAAABQAAAAAAAAAwMD/AAAAAABkAAAAMgAAAAAAAABkAAAAAAAAAH9/fwAKAAAAIgAAABgAAAAAAAAAAAAAAAAAAAAAAAAAAAAAAAAAAAAkAAAAJAAAAAAAAAAHAAAAAAAAAAAAAAAAAAAAAAAAAAAAAAAAAAAAf39/ACUAAABYAAAAAAAAAAAAAAAAAAAAAAAAAAAAAAAAAAAAAAAAAAAAAAAAAAAAAAAAAAAAAAA/AAAAAAAAAKCGAQAAAAAAAAAAAAAAAAAMAAAAAQAAAAAAAAAAAAAAAAAAAB8AAABUAAAAAAAABQAAAAEAAAAAAAAAAAAAAAAAAAAAAAAAAAAAAAAAAAAAAAAAAAAAAAJ/f38AAAAAA8zMzADAwP8Af39/AAAAAAAAAAAAAAAAAAAAAAAAAAAAIQAAABgAAAAUAAAAFAMAAEoPAADlMwAAMhYAABAAAAAmAAAACAAAAL2wAAAAAAAA"/>
               </a:ext>
             </a:extLst>
           </p:cNvSpPr>
@@ -4442,7 +4442,7 @@
             <a:spLocks noGrp="1" noChangeArrowheads="1"/>
             <a:extLst>
               <a:ext uri="smNativeData">
-                <pr:smNativeData xmlns:pr="smNativeData" xmlns="smNativeData" val="SMDATA_15_FUV5ZhMAAAAlAAAAZAAAAA0AAAAAkAAAAJAAAACQAAAAkAAAAAAAAAABAAAAAAAAAAEAAABQAAAAAAAAAAAA4D8AAAAAAADgPwAAAAAAAOA/AAAAAAAA4D8AAAAAAADgPwAAAAAAAOA/AAAAAAAA4D8AAAAAAADgPwAAAAAAAOA/AAAAAAAA4D8CAAAAjAAAAAAAAAAAAAAAQoX0DP///wgAAAAAAAAAAAAAAAAAAAAAAAAAAAAAAAAAAAAAZAAAAAEAAABAAAAAAAAAAAAAAAAAAAAAAAAAAAAAAAAAAAAAAAAAAAAAAAAAAAAAAAAAAAAAAAAAAAAAAAAAAAAAAAAAAAAAAAAAAAAAAAAAAAAAAAAAAAAAAAAAAAAAFAAAADwAAAAAAAAAAAAAAAAAAAkUAAAAAQAAABQAAAAUAAAAFAAAAAEAAAAAAAAAZAAAAGQAAAAAAAAAZAAAAGQAAAAVAAAAYAAAAAAAAAAAAAAADwAAACADAAAAAAAAAAAAAAEAAACgMgAAVgcAAKr4//8BAAAAf39/AAEAAABkAAAAAAAAABQAAABAHwAAAAAAACYAAAAAAAAAwOD//wAAAAAmAAAAZAAAABYAAABMAAAAAAAAAAAAAAAEAAAAAAAAAAEAAABZWVkKAAAAACgAAAAoAAAAZAAAAGQAAAAAAAAAzMzMAAAAAABQAAAAUAAAAGQAAABkAAAAAAAAABcAAAAUAAAAAAAAAAAAAAD/fwAA/38AAAAAAAAJAAAABAAAAAAAAAAeAAAAaAAAAAAAAAAAAAAAAAAAAAAAAAAAAAAAECcAABAnAAAAAAAAAAAAAAAAAAAAAAAAAAAAAAAAAAAAAAAAAAAAABQAAAAAAAAAwMD/AAAAAABkAAAAMgAAAAAAAABkAAAAAAAAAH9/fwAKAAAAIgAAABgAAAAAAAAAAAAAAAAAAAAAAAAAAAAAAAAAAAAkAAAAJAAAAAAAAAAHAAAAAAAAAAAAAAAAAAAAAAAAAAAAAAAAAAAAf39/ACUAAABYAAAAAAAAAAAAAAAAAAAAAAAAAAAAAAAAAAAAAAAAAAAAAAAAAAAAAAAAAAAAAAA/AAAAAAAAAKCGAQAAAAAAAAAAAAAAAAAMAAAAAQAAAAAAAAAAAAAAAAAAAB8AAABUAAAAAAAABQAAAAEAAAAAAAAAAAAAAAAAAAAAAAAAAAAAAAAAAAAAAAAAAAAAAAJ/f38AAAAAA8zMzADAwP8Af39/AAAAAAAAAAAAAAAAAAAAAAAAAAAAIQAAABgAAAAUAAAAHjQAAEAmAAB/NwAAeikAABAAAAAmAAAACAAAADywAAAAAAAA"/>
+                <pr:smNativeData xmlns:pr="smNativeData" xmlns="smNativeData" val="SMDATA_15_9kV5ZhMAAAAlAAAAZAAAAA0AAAAAkAAAAJAAAACQAAAAkAAAAAAAAAABAAAAAAAAAAEAAABQAAAAAAAAAAAA4D8AAAAAAADgPwAAAAAAAOA/AAAAAAAA4D8AAAAAAADgPwAAAAAAAOA/AAAAAAAA4D8AAAAAAADgPwAAAAAAAOA/AAAAAAAA4D8CAAAAjAAAAAAAAAAAAAAAQoX0DP///wgAAAAAAAAAAAAAAAAAAAAAAAAAAAAAAAAAAAAAZAAAAAEAAABAAAAAAAAAAAAAAAAAAAAAAAAAAAAAAAAAAAAAAAAAAAAAAAAAAAAAAAAAAAAAAAAAAAAAAAAAAAAAAAAAAAAAAAAAAAAAAAAAAAAAAAAAAAAAAAAAAAAAFAAAADwAAAAAAAAAAAAAAAAAAAkUAAAAAQAAABQAAAAUAAAAFAAAAAEAAAAAAAAAZAAAAGQAAAAAAAAAZAAAAGQAAAAVAAAAYAAAAAAAAAAAAAAADwAAACADAAAAAAAAAAAAAAEAAACgMgAAVgcAAKr4//8BAAAAf39/AAEAAABkAAAAAAAAABQAAABAHwAAAAAAACYAAAAAAAAAwOD//wAAAAAmAAAAZAAAABYAAABMAAAAAAAAAAAAAAAEAAAAAAAAAAEAAABZWVkKAAAAACgAAAAoAAAAZAAAAGQAAAAAAAAAzMzMAAAAAABQAAAAUAAAAGQAAABkAAAAAAAAABcAAAAUAAAAAAAAAAAAAAD/fwAA/38AAAAAAAAJAAAABAAAAAAAAAAeAAAAaAAAAAAAAAAAAAAAAAAAAAAAAAAAAAAAECcAABAnAAAAAAAAAAAAAAAAAAAAAAAAAAAAAAAAAAAAAAAAAAAAABQAAAAAAAAAwMD/AAAAAABkAAAAMgAAAAAAAABkAAAAAAAAAH9/fwAKAAAAIgAAABgAAAAAAAAAAAAAAAAAAAAAAAAAAAAAAAAAAAAkAAAAJAAAAAAAAAAHAAAAAAAAAAAAAAAAAAAAAAAAAAAAAAAAAAAAf39/ACUAAABYAAAAAAAAAAAAAAAAAAAAAAAAAAAAAAAAAAAAAAAAAAAAAAAAAAAAAAAAAAAAAAA/AAAAAAAAAKCGAQAAAAAAAAAAAAAAAAAMAAAAAQAAAAAAAAAAAAAAAAAAAB8AAABUAAAAAAAABQAAAAEAAAAAAAAAAAAAAAAAAAAAAAAAAAAAAAAAAAAAAAAAAAAAAAJ/f38AAAAAA8zMzADAwP8Af39/AAAAAAAAAAAAAAAAAAAAAAAAAAAAIQAAABgAAAAUAAAAHjQAAEAmAAB/NwAAeikAABAAAAAmAAAACAAAADywAAAAAAAA"/>
               </a:ext>
             </a:extLst>
           </p:cNvSpPr>
@@ -4496,7 +4496,7 @@
               </a:spcAft>
               <a:buNone/>
             </a:pPr>
-            <a:fld id="{3FD97718-56D2-8C81-9C61-A0D4392F6AF5}" type="slidenum">
+            <a:fld id="{3FDDF580-CED2-8803-9C65-3856BB2B6A6D}" type="slidenum">
               <a:rPr lang="ru-ru" cap="none"/>
               <a:t/>
             </a:fld>
@@ -4537,7 +4537,7 @@
             <a:spLocks noGrp="1" noChangeArrowheads="1"/>
             <a:extLst>
               <a:ext uri="smNativeData">
-                <pr:smNativeData xmlns:pr="smNativeData" xmlns="smNativeData" val="SMDATA_15_FUV5ZhMAAAAlAAAAZAAAAA0AAAAAkAAAAJAAAACQAAAAkAAAAAAAAAAAAAAAAAAAAAEAAABQAAAAAAAAAAAA4D8AAAAAAADgPwAAAAAAAOA/AAAAAAAA4D8AAAAAAADgPwAAAAAAAOA/AAAAAAAA4D8AAAAAAADgPwAAAAAAAOA/AAAAAAAA4D8CAAAAjAAAAAAAAAAAAAAAQoX0DP///wgAAAAAAAAAAAAAAAAAAAAAAAAAAAAAAAAAAAAAZAAAAAEAAABAAAAAAAAAAAAAAAAAAAAAAAAAAAAAAAAAAAAAAAAAAAAAAAAAAAAAAAAAAAAAAAAAAAAAAAAAAAAAAAAAAAAAAAAAAAAAAAAAAAAAAAAAAAAAAAAAAAAAFAAAADwAAAAAAAAAAAAAAAAAAAkUAAAAAQAAABQAAAAUAAAAFAAAAAEAAAAAAAAAZAAAAGQAAAAAAAAAZAAAAGQAAAAVAAAAYAAAAAAAAAAAAAAADwAAACADAAAAAAAAAAAAAAEAAACgMgAAVgcAAKr4//8BAAAAf39/AAEAAABkAAAAAAAAABQAAABAHwAAAAAAACYAAAAAAAAAwOD//wAAAAAmAAAAZAAAABYAAABMAAAAAAAAAAAAAAAEAAAAAAAAAAEAAABZWVkKAAAAACgAAAAoAAAAZAAAAGQAAAAAAAAAzMzMAAAAAABQAAAAUAAAAGQAAABkAAAAAAAAABcAAAAUAAAAAAAAAAAAAAD/fwAA/38AAAAAAAAJAAAABAAAAMhrcwceAAAAaAAAAAAAAAAAAAAAAAAAAAAAAAAAAAAAECcAABAnAAAAAAAAAAAAAAAAAAAAAAAAAAAAAAAAAAAAAAAAAAAAABQAAAAAAAAAwMD/AAAAAABkAAAAMgAAAAAAAABkAAAAAAAAAH9/fwAKAAAAIgAAABgAAAAAAAAAAAAAAAAAAAAAAAAAAAAAAAAAAAAkAAAAJAAAAAAAAAAHAAAAAAAAAAAAAAAAAAAAAAAAAAAAAAAAAAAAf39/ACUAAABYAAAAAAAAAAAAAAAAAAAAAAAAAAAAAAAAAAAAAAAAAAAAAAAAAAAAAAAAAAAAAAA/AAAAAAAAAKCGAQAAAAAAAAAAAAAAAAAMAAAAAQAAAAAAAAAAAAAAAAAAAB8AAABUAAAAAAAABQAAAAEAAAAAAAAAAAAAAAAAAAAAAAAAAAAAAAAAAAAAAAAAAAAAAAJ/f38AAAAAA8zMzADAwP8Af39/AAAAAAAAAAAAAAAAAAAAAAAAAAAAIQAAABgAAAAUAAAAFAMAALYCAAB/NwAAvwoAABAAAAAmAAAACAAAADywAAAAAAAA"/>
+                <pr:smNativeData xmlns:pr="smNativeData" xmlns="smNativeData" val="SMDATA_15_9kV5ZhMAAAAlAAAAZAAAAA0AAAAAkAAAAJAAAACQAAAAkAAAAAAAAAAAAAAAAAAAAAEAAABQAAAAAAAAAAAA4D8AAAAAAADgPwAAAAAAAOA/AAAAAAAA4D8AAAAAAADgPwAAAAAAAOA/AAAAAAAA4D8AAAAAAADgPwAAAAAAAOA/AAAAAAAA4D8CAAAAjAAAAAAAAAAAAAAAQoX0DP///wgAAAAAAAAAAAAAAAAAAAAAAAAAAAAAAAAAAAAAZAAAAAEAAABAAAAAAAAAAAAAAAAAAAAAAAAAAAAAAAAAAAAAAAAAAAAAAAAAAAAAAAAAAAAAAAAAAAAAAAAAAAAAAAAAAAAAAAAAAAAAAAAAAAAAAAAAAAAAAAAAAAAAFAAAADwAAAAAAAAAAAAAAAAAAAkUAAAAAQAAABQAAAAUAAAAFAAAAAEAAAAAAAAAZAAAAGQAAAAAAAAAZAAAAGQAAAAVAAAAYAAAAAAAAAAAAAAADwAAACADAAAAAAAAAAAAAAEAAACgMgAAVgcAAKr4//8BAAAAf39/AAEAAABkAAAAAAAAABQAAABAHwAAAAAAACYAAAAAAAAAwOD//wAAAAAmAAAAZAAAABYAAABMAAAAAAAAAAAAAAAEAAAAAAAAAAEAAABZWVkKAAAAACgAAAAoAAAAZAAAAGQAAAAAAAAAzMzMAAAAAABQAAAAUAAAAGQAAABkAAAAAAAAABcAAAAUAAAAAAAAAAAAAAD/fwAA/38AAAAAAAAJAAAABAAAAMhrcwceAAAAaAAAAAAAAAAAAAAAAAAAAAAAAAAAAAAAECcAABAnAAAAAAAAAAAAAAAAAAAAAAAAAAAAAAAAAAAAAAAAAAAAABQAAAAAAAAAwMD/AAAAAABkAAAAMgAAAAAAAABkAAAAAAAAAH9/fwAKAAAAIgAAABgAAAAAAAAAAAAAAAAAAAAAAAAAAAAAAAAAAAAkAAAAJAAAAAAAAAAHAAAAAAAAAAAAAAAAAAAAAAAAAAAAAAAAAAAAf39/ACUAAABYAAAAAAAAAAAAAAAAAAAAAAAAAAAAAAAAAAAAAAAAAAAAAAAAAAAAAAAAAAAAAAA/AAAAAAAAAKCGAQAAAAAAAAAAAAAAAAAMAAAAAQAAAAAAAAAAAAAAAAAAAB8AAABUAAAAAAAABQAAAAEAAAAAAAAAAAAAAAAAAAAAAAAAAAAAAAAAAAAAAAAAAAAAAAJ/f38AAAAAA8zMzADAwP8Af39/AAAAAAAAAAAAAAAAAAAAAAAAAAAAIQAAABgAAAAUAAAAFAMAALYCAAB/NwAAvwoAABAAAAAmAAAACAAAADywAAAAAAAA"/>
               </a:ext>
             </a:extLst>
           </p:cNvSpPr>
@@ -4647,7 +4647,7 @@
             <a:spLocks noGrp="1" noChangeArrowheads="1"/>
             <a:extLst>
               <a:ext uri="smNativeData">
-                <pr:smNativeData xmlns:pr="smNativeData" xmlns="smNativeData" val="SMDATA_15_FUV5ZhMAAAAlAAAAZAAAAA0AAAAAkAAAAJAAAACQAAAAkAAAAAAAAAAAAAAAAAAAAAEAAABQAAAAAAAAAAAA4D8AAAAAAADgPwAAAAAAAOA/AAAAAAAA4D8AAAAAAADgPwAAAAAAAOA/AAAAAAAA4D8AAAAAAADgPwAAAAAAAOA/AAAAAAAA4D8CAAAAjAAAAAAAAAAAAAAAQoX0DP///wgAAAAAAAAAAAAAAAAAAAAAAAAAAAAAAAAAAAAAZAAAAAEAAABAAAAAAAAAAAAAAAAAAAAAAAAAAAAAAAAAAAAAAAAAAAAAAAAAAAAAAAAAAAAAAAAAAAAAAAAAAAAAAAAAAAAAAAAAAAAAAAAAAAAAAAAAAAAAAAAAAAAAFAAAADwAAAAAAAAAAAAAAAAAAAkUAAAAAQAAABQAAAAUAAAAFAAAAAEAAAAAAAAAZAAAAGQAAAAAAAAAZAAAAGQAAAAVAAAAYAAAAAAAAAAAAAAADwAAACADAAAAAAAAAAAAAAEAAACgMgAAVgcAAKr4//8BAAAAf39/AAEAAABkAAAAAAAAABQAAABAHwAAAAAAACYAAAAAAAAAwOD//wAAAAAmAAAAZAAAABYAAABMAAAAAAAAAAAAAAAEAAAAAAAAAAEAAABZWVkKAAAAACgAAAAoAAAAZAAAAGQAAAAAAAAAzMzMAAAAAABQAAAAUAAAAGQAAABkAAAAAAAAABcAAAAUAAAAAAAAAAAAAAD/fwAA/38AAAAAAAAJAAAABAAAAF8AYAAeAAAAaAAAAAAAAAAAAAAAAAAAAAAAAAAAAAAAECcAABAnAAAAAAAAAAAAAAAAAAAAAAAAAAAAAAAAAAAAAAAAAAAAABQAAAAAAAAAwMD/AAAAAABkAAAAMgAAAAAAAABkAAAAAAAAAH9/fwAKAAAAIgAAABgAAAAAAAAAAAAAAAAAAAAAAAAAAAAAAAAAAAAkAAAAJAAAAAAAAAAHAAAAAAAAAAAAAAAAAAAAAAAAAAAAAAAAAAAAf39/ACUAAABYAAAAAAAAAAAAAAAAAAAAAAAAAAAAAAAAAAAAAAAAAAAAAAAAAAAAAAAAAAAAAAA/AAAAAAAAAKCGAQAAAAAAAAAAAAAAAAAMAAAAAQAAAAAAAAAAAAAAAAAAAB8AAABUAAAAAAAABQAAAAEAAAAAAAAAAAAAAAAAAAAAAAAAAAAAAAAAAAAAAAAAAAAAAAJ/f38AAAAAA8zMzADAwP8Af39/AAAAAAAAAAAAAAAAAAAAAAAAAAAAIQAAABgAAAAUAAAAFAMAALMLAAB/NwAAuScAABAAAAAmAAAACAAAAD2wAAAAAAAA"/>
+                <pr:smNativeData xmlns:pr="smNativeData" xmlns="smNativeData" val="SMDATA_15_9kV5ZhMAAAAlAAAAZAAAAA0AAAAAkAAAAJAAAACQAAAAkAAAAAAAAAAAAAAAAAAAAAEAAABQAAAAAAAAAAAA4D8AAAAAAADgPwAAAAAAAOA/AAAAAAAA4D8AAAAAAADgPwAAAAAAAOA/AAAAAAAA4D8AAAAAAADgPwAAAAAAAOA/AAAAAAAA4D8CAAAAjAAAAAAAAAAAAAAAQoX0DP///wgAAAAAAAAAAAAAAAAAAAAAAAAAAAAAAAAAAAAAZAAAAAEAAABAAAAAAAAAAAAAAAAAAAAAAAAAAAAAAAAAAAAAAAAAAAAAAAAAAAAAAAAAAAAAAAAAAAAAAAAAAAAAAAAAAAAAAAAAAAAAAAAAAAAAAAAAAAAAAAAAAAAAFAAAADwAAAAAAAAAAAAAAAAAAAkUAAAAAQAAABQAAAAUAAAAFAAAAAEAAAAAAAAAZAAAAGQAAAAAAAAAZAAAAGQAAAAVAAAAYAAAAAAAAAAAAAAADwAAACADAAAAAAAAAAAAAAEAAACgMgAAVgcAAKr4//8BAAAAf39/AAEAAABkAAAAAAAAABQAAABAHwAAAAAAACYAAAAAAAAAwOD//wAAAAAmAAAAZAAAABYAAABMAAAAAAAAAAAAAAAEAAAAAAAAAAEAAABZWVkKAAAAACgAAAAoAAAAZAAAAGQAAAAAAAAAzMzMAAAAAABQAAAAUAAAAGQAAABkAAAAAAAAABcAAAAUAAAAAAAAAAAAAAD/fwAA/38AAAAAAAAJAAAABAAAAF8AYAAeAAAAaAAAAAAAAAAAAAAAAAAAAAAAAAAAAAAAECcAABAnAAAAAAAAAAAAAAAAAAAAAAAAAAAAAAAAAAAAAAAAAAAAABQAAAAAAAAAwMD/AAAAAABkAAAAMgAAAAAAAABkAAAAAAAAAH9/fwAKAAAAIgAAABgAAAAAAAAAAAAAAAAAAAAAAAAAAAAAAAAAAAAkAAAAJAAAAAAAAAAHAAAAAAAAAAAAAAAAAAAAAAAAAAAAAAAAAAAAf39/ACUAAABYAAAAAAAAAAAAAAAAAAAAAAAAAAAAAAAAAAAAAAAAAAAAAAAAAAAAAAAAAAAAAAA/AAAAAAAAAKCGAQAAAAAAAAAAAAAAAAAMAAAAAQAAAAAAAAAAAAAAAAAAAB8AAABUAAAAAAAABQAAAAEAAAAAAAAAAAAAAAAAAAAAAAAAAAAAAAAAAAAAAAAAAAAAAAJ/f38AAAAAA8zMzADAwP8Af39/AAAAAAAAAAAAAAAAAAAAAAAAAAAAIQAAABgAAAAUAAAAFAMAALMLAAB/NwAAuScAABAAAAAmAAAACAAAAD2wAAAAAAAA"/>
               </a:ext>
             </a:extLst>
           </p:cNvSpPr>
@@ -4798,7 +4798,7 @@
             <a:spLocks noGrp="1" noChangeArrowheads="1"/>
             <a:extLst>
               <a:ext uri="smNativeData">
-                <pr:smNativeData xmlns:pr="smNativeData" xmlns="smNativeData" val="SMDATA_15_FUV5ZhMAAAAlAAAAZAAAAA0AAAAAkAAAAJAAAACQAAAAkAAAAAAAAAABAAAAAAAAAAEAAABQAAAAAAAAAAAA4D8AAAAAAADgPwAAAAAAAOA/AAAAAAAA4D8AAAAAAADgPwAAAAAAAOA/AAAAAAAA4D8AAAAAAADgPwAAAAAAAOA/AAAAAAAA4D8CAAAAjAAAAAAAAAAAAAAAQoX0DP///wgAAAAAAAAAAAAAAAAAAAAAAAAAAAAAAAAAAAAAZAAAAAEAAABAAAAAAAAAAAAAAAAAAAAAAAAAAAAAAAAAAAAAAAAAAAAAAAAAAAAAAAAAAAAAAAAAAAAAAAAAAAAAAAAAAAAAAAAAAAAAAAAAAAAAAAAAAAAAAAAAAAAAFAAAADwAAAAAAAAAAAAAAAAAAAkUAAAAAQAAABQAAAAUAAAAFAAAAAEAAAAAAAAAZAAAAGQAAAAAAAAAZAAAAGQAAAAVAAAAYAAAAAAAAAAAAAAADwAAACADAAAAAAAAAAAAAAEAAACgMgAAVgcAAKr4//8BAAAAf39/AAEAAABkAAAAAAAAABQAAABAHwAAAAAAACYAAAAAAAAAwOD//wAAAAAmAAAAZAAAABYAAABMAAAAAAAAAAAAAAAEAAAAAAAAAAEAAABZWVkKAAAAACgAAAAoAAAAZAAAAGQAAAAAAAAAzMzMAAAAAABQAAAAUAAAAGQAAABkAAAAAAAAABcAAAAUAAAAAAAAAAAAAAD/fwAA/38AAAAAAAAJAAAABAAAAF8AYAAeAAAAaAAAAAAAAAAAAAAAAAAAAAAAAAAAAAAAECcAABAnAAAAAAAAAAAAAAAAAAAAAAAAAAAAAAAAAAAAAAAAAAAAABQAAAAAAAAAwMD/AAAAAABkAAAAMgAAAAAAAABkAAAAAAAAAH9/fwAKAAAAIgAAABgAAAAAAAAAAAAAAAAAAAAAAAAAAAAAAAAAAAAkAAAAJAAAAAAAAAAHAAAAAAAAAAAAAAAAAAAAAAAAAAAAAAAAAAAAf39/ACUAAABYAAAAAAAAAAAAAAAAAAAAAAAAAAAAAAAAAAAAAAAAAAAAAAAAAAAAAAAAAAAAAAA/AAAAAAAAAKCGAQAAAAAAAAAAAAAAAAAMAAAAAQAAAAAAAAAAAAAAAAAAAB8AAABUAAAAAAAABQAAAAEAAAAAAAAAAAAAAAAAAAAAAAAAAAAAAAAAAAAAAAAAAAAAAAJ/f38AAAAAA8zMzADAwP8Af39/AAAAAAAAAAAAAAAAAAAAAAAAAAAAIQAAABgAAAAUAAAAHjQAAEAmAAB/NwAAeikAABAAAAAmAAAACAAAADywAAAAAAAA"/>
+                <pr:smNativeData xmlns:pr="smNativeData" xmlns="smNativeData" val="SMDATA_15_9kV5ZhMAAAAlAAAAZAAAAA0AAAAAkAAAAJAAAACQAAAAkAAAAAAAAAABAAAAAAAAAAEAAABQAAAAAAAAAAAA4D8AAAAAAADgPwAAAAAAAOA/AAAAAAAA4D8AAAAAAADgPwAAAAAAAOA/AAAAAAAA4D8AAAAAAADgPwAAAAAAAOA/AAAAAAAA4D8CAAAAjAAAAAAAAAAAAAAAQoX0DP///wgAAAAAAAAAAAAAAAAAAAAAAAAAAAAAAAAAAAAAZAAAAAEAAABAAAAAAAAAAAAAAAAAAAAAAAAAAAAAAAAAAAAAAAAAAAAAAAAAAAAAAAAAAAAAAAAAAAAAAAAAAAAAAAAAAAAAAAAAAAAAAAAAAAAAAAAAAAAAAAAAAAAAFAAAADwAAAAAAAAAAAAAAAAAAAkUAAAAAQAAABQAAAAUAAAAFAAAAAEAAAAAAAAAZAAAAGQAAAAAAAAAZAAAAGQAAAAVAAAAYAAAAAAAAAAAAAAADwAAACADAAAAAAAAAAAAAAEAAACgMgAAVgcAAKr4//8BAAAAf39/AAEAAABkAAAAAAAAABQAAABAHwAAAAAAACYAAAAAAAAAwOD//wAAAAAmAAAAZAAAABYAAABMAAAAAAAAAAAAAAAEAAAAAAAAAAEAAABZWVkKAAAAACgAAAAoAAAAZAAAAGQAAAAAAAAAzMzMAAAAAABQAAAAUAAAAGQAAABkAAAAAAAAABcAAAAUAAAAAAAAAAAAAAD/fwAA/38AAAAAAAAJAAAABAAAAF8AYAAeAAAAaAAAAAAAAAAAAAAAAAAAAAAAAAAAAAAAECcAABAnAAAAAAAAAAAAAAAAAAAAAAAAAAAAAAAAAAAAAAAAAAAAABQAAAAAAAAAwMD/AAAAAABkAAAAMgAAAAAAAABkAAAAAAAAAH9/fwAKAAAAIgAAABgAAAAAAAAAAAAAAAAAAAAAAAAAAAAAAAAAAAAkAAAAJAAAAAAAAAAHAAAAAAAAAAAAAAAAAAAAAAAAAAAAAAAAAAAAf39/ACUAAABYAAAAAAAAAAAAAAAAAAAAAAAAAAAAAAAAAAAAAAAAAAAAAAAAAAAAAAAAAAAAAAA/AAAAAAAAAKCGAQAAAAAAAAAAAAAAAAAMAAAAAQAAAAAAAAAAAAAAAAAAAB8AAABUAAAAAAAABQAAAAEAAAAAAAAAAAAAAAAAAAAAAAAAAAAAAAAAAAAAAAAAAAAAAAJ/f38AAAAAA8zMzADAwP8Af39/AAAAAAAAAAAAAAAAAAAAAAAAAAAAIQAAABgAAAAUAAAAHjQAAEAmAAB/NwAAeikAABAAAAAmAAAACAAAADywAAAAAAAA"/>
               </a:ext>
             </a:extLst>
           </p:cNvSpPr>
@@ -4852,7 +4852,7 @@
               </a:spcAft>
               <a:buNone/>
             </a:pPr>
-            <a:fld id="{3FD90F26-68D2-8CF9-9C61-9EAC412F6ACB}" type="slidenum">
+            <a:fld id="{3FDDCA4B-05D2-883C-9C65-F369842B6AA6}" type="slidenum">
               <a:rPr lang="ru-ru" cap="none"/>
               <a:t/>
             </a:fld>
@@ -4893,7 +4893,7 @@
             <a:spLocks noGrp="1" noChangeArrowheads="1"/>
             <a:extLst>
               <a:ext uri="smNativeData">
-                <pr:smNativeData xmlns:pr="smNativeData" xmlns="smNativeData" val="SMDATA_15_FUV5ZhMAAAAlAAAAZAAAAA0AAAAAkAAAAJAAAACQAAAAkAAAAAAAAAABAAAAAAAAAAEAAABQAAAAAAAAAAAA4D8AAAAAAADgPwAAAAAAAOA/AAAAAAAA4D8AAAAAAADgPwAAAAAAAOA/AAAAAAAA4D8AAAAAAADgPwAAAAAAAOA/AAAAAAAA4D8CAAAAjAAAAAAAAAAAAAAAQoX0DP///wgAAAAAAAAAAAAAAAAAAAAAAAAAAAAAAAAAAAAAZAAAAAEAAABAAAAAAAAAAAAAAAAAAAAAAAAAAAAAAAAAAAAAAAAAAAAAAAAAAAAAAAAAAAAAAAAAAAAAAAAAAAAAAAAAAAAAAAAAAAAAAAAAAAAAAAAAAAAAAAAAAAAAFAAAADwAAAAAAAAAAAAAAAAAAAkUAAAAAQAAABQAAAAUAAAAFAAAAAEAAAAAAAAAZAAAAGQAAAAAAAAAZAAAAGQAAAAVAAAAYAAAAAAAAAAAAAAADwAAACADAAAAAAAAAAAAAAEAAACgMgAAVgcAAKr4//8BAAAAf39/AAEAAABkAAAAAAAAABQAAABAHwAAAAAAACYAAAAAAAAAwOD//wAAAAAmAAAAZAAAABYAAABMAAAAAAAAAAAAAAAEAAAAAAAAAAEAAABZWVkKAAAAACgAAAAoAAAAZAAAAGQAAAAAAAAAzMzMAAAAAABQAAAAUAAAAGQAAABkAAAAAAAAABcAAAAUAAAAAAAAAAAAAAD/fwAA/38AAAAAAAAJAAAABAAAAAAAAAAeAAAAaAAAAAAAAAAAAAAAAAAAAAAAAAAAAAAAECcAABAnAAAAAAAAAAAAAAAAAAAAAAAAAAAAAAAAAAAAAAAAAAAAABQAAAAAAAAAwMD/AAAAAABkAAAAMgAAAAAAAABkAAAAAAAAAH9/fwAKAAAAIgAAABgAAAAAAAAAAAAAAAAAAAAAAAAAAAAAAAAAAAAkAAAAJAAAAAAAAAAHAAAAAAAAAAAAAAAAAAAAAAAAAAAAAAAAAAAAf39/ACUAAABYAAAAAAAAAAAAAAAAAAAAAAAAAAAAAAAAAAAAAAAAAAAAAAAAAAAAAAAAAAAAAAA/AAAAAAAAAKCGAQAAAAAAAAAAAAAAAAAMAAAAAQAAAAAAAAAAAAAAAAAAAB8AAABUAAAAAAAABQAAAAEAAAAAAAAAAAAAAAAAAAAAAAAAAAAAAAAAAAAAAAAAAAAAAAJ/f38AAAAAA8zMzADAwP8Af39/AAAAAAAAAAAAAAAAAAAAAAAAAAAAIQAAABgAAAAUAAAAHjQAAEAmAAB/NwAAeikAABAAAAAmAAAACAAAADywAAAAAAAA"/>
+                <pr:smNativeData xmlns:pr="smNativeData" xmlns="smNativeData" val="SMDATA_15_9kV5ZhMAAAAlAAAAZAAAAA0AAAAAkAAAAJAAAACQAAAAkAAAAAAAAAABAAAAAAAAAAEAAABQAAAAAAAAAAAA4D8AAAAAAADgPwAAAAAAAOA/AAAAAAAA4D8AAAAAAADgPwAAAAAAAOA/AAAAAAAA4D8AAAAAAADgPwAAAAAAAOA/AAAAAAAA4D8CAAAAjAAAAAAAAAAAAAAAQoX0DP///wgAAAAAAAAAAAAAAAAAAAAAAAAAAAAAAAAAAAAAZAAAAAEAAABAAAAAAAAAAAAAAAAAAAAAAAAAAAAAAAAAAAAAAAAAAAAAAAAAAAAAAAAAAAAAAAAAAAAAAAAAAAAAAAAAAAAAAAAAAAAAAAAAAAAAAAAAAAAAAAAAAAAAFAAAADwAAAAAAAAAAAAAAAAAAAkUAAAAAQAAABQAAAAUAAAAFAAAAAEAAAAAAAAAZAAAAGQAAAAAAAAAZAAAAGQAAAAVAAAAYAAAAAAAAAAAAAAADwAAACADAAAAAAAAAAAAAAEAAACgMgAAVgcAAKr4//8BAAAAf39/AAEAAABkAAAAAAAAABQAAABAHwAAAAAAACYAAAAAAAAAwOD//wAAAAAmAAAAZAAAABYAAABMAAAAAAAAAAAAAAAEAAAAAAAAAAEAAABZWVkKAAAAACgAAAAoAAAAZAAAAGQAAAAAAAAAzMzMAAAAAABQAAAAUAAAAGQAAABkAAAAAAAAABcAAAAUAAAAAAAAAAAAAAD/fwAA/38AAAAAAAAJAAAABAAAAAAAAAAeAAAAaAAAAAAAAAAAAAAAAAAAAAAAAAAAAAAAECcAABAnAAAAAAAAAAAAAAAAAAAAAAAAAAAAAAAAAAAAAAAAAAAAABQAAAAAAAAAwMD/AAAAAABkAAAAMgAAAAAAAABkAAAAAAAAAH9/fwAKAAAAIgAAABgAAAAAAAAAAAAAAAAAAAAAAAAAAAAAAAAAAAAkAAAAJAAAAAAAAAAHAAAAAAAAAAAAAAAAAAAAAAAAAAAAAAAAAAAAf39/ACUAAABYAAAAAAAAAAAAAAAAAAAAAAAAAAAAAAAAAAAAAAAAAAAAAAAAAAAAAAAAAAAAAAA/AAAAAAAAAKCGAQAAAAAAAAAAAAAAAAAMAAAAAQAAAAAAAAAAAAAAAAAAAB8AAABUAAAAAAAABQAAAAEAAAAAAAAAAAAAAAAAAAAAAAAAAAAAAAAAAAAAAAAAAAAAAAJ/f38AAAAAA8zMzADAwP8Af39/AAAAAAAAAAAAAAAAAAAAAAAAAAAAIQAAABgAAAAUAAAAHjQAAEAmAAB/NwAAeikAABAAAAAmAAAACAAAADywAAAAAAAA"/>
               </a:ext>
             </a:extLst>
           </p:cNvSpPr>
@@ -4947,7 +4947,7 @@
               </a:spcAft>
               <a:buNone/>
             </a:pPr>
-            <a:fld id="{3FD92FB5-FBD2-8CD9-9C61-0D8C612F6A58}" type="slidenum">
+            <a:fld id="{3FDDB7B3-FDD2-8841-9C65-0B14F92B6A5E}" type="slidenum">
               <a:rPr lang="ru-ru" cap="none"/>
               <a:t/>
             </a:fld>
@@ -4962,7 +4962,7 @@
             <a:spLocks noGrp="1" noChangeArrowheads="1"/>
             <a:extLst>
               <a:ext uri="smNativeData">
-                <pr:smNativeData xmlns:pr="smNativeData" xmlns="smNativeData" val="SMDATA_15_FUV5ZhMAAAAlAAAAZAAAAA0AAAAAkAAAAJAAAACQAAAAkAAAAAAAAAAAAAAAAAAAAAEAAABQAAAAAAAAAAAA4D8AAAAAAADgPwAAAAAAAOA/AAAAAAAA4D8AAAAAAADgPwAAAAAAAOA/AAAAAAAA4D8AAAAAAADgPwAAAAAAAOA/AAAAAAAA4D8CAAAAjAAAAAAAAAAAAAAAQoX0DP///wgAAAAAAAAAAAAAAAAAAAAAAAAAAAAAAAAAAAAAZAAAAAEAAABAAAAAAAAAAAAAAAAAAAAAAAAAAAAAAAAAAAAAAAAAAAAAAAAAAAAAAAAAAAAAAAAAAAAAAAAAAAAAAAAAAAAAAAAAAAAAAAAAAAAAAAAAAAAAAAAAAAAAFAAAADwAAAAAAAAAAAAAAAAAAAkUAAAAAQAAABQAAAAUAAAAFAAAAAEAAAAAAAAAZAAAAGQAAAAAAAAAZAAAAGQAAAAVAAAAYAAAAAAAAAAAAAAADwAAACADAAAAAAAAAAAAAAEAAACgMgAAVgcAAKr4//8BAAAAf39/AAEAAABkAAAAAAAAABQAAABAHwAAAAAAACYAAAAAAAAAwOD//wAAAAAmAAAAZAAAABYAAABMAAAAAAAAAAAAAAAEAAAAAAAAAAEAAABZWVkKAAAAACgAAAAoAAAAZAAAAGQAAAAAAAAAzMzMAAAAAABQAAAAUAAAAGQAAABkAAAAAAAAABcAAAAUAAAAAAAAAAAAAAD/fwAA/38AAAAAAAAJAAAABAAAAF0AXgAeAAAAaAAAAAAAAAAAAAAAAAAAAAAAAAAAAAAAECcAABAnAAAAAAAAAAAAAAAAAAAAAAAAAAAAAAAAAAAAAAAAAAAAABQAAAAAAAAAwMD/AAAAAABkAAAAMgAAAAAAAABkAAAAAAAAAH9/fwAKAAAAIgAAABgAAAAAAAAAAAAAAAAAAAAAAAAAAAAAAAAAAAAkAAAAJAAAAAAAAAAHAAAAAAAAAAAAAAAAAAAAAAAAAAAAAAAAAAAAf39/ACUAAABYAAAAAAAAAAAAAAAAAAAAAAAAAAAAAAAAAAAAAAAAAAAAAAAAAAAAAAAAAAAAAAA/AAAAAAAAAKCGAQAAAAAAAAAAAAAAAAAMAAAAAQAAAAAAAAAAAAAAAAAAAB8AAABUAAAAAAAABQAAAAEAAAAAAAAAAAAAAAAAAAAAAAAAAAAAAAAAAAAAAAAAAAAAAAJ/f38AAAAAA8zMzADAwP8Af39/AAAAAAAAAAAAAAAAAAAAAAAAAAAAIQAAABgAAAAUAAAAFAMAALwGAAB/NwAAARcAABAAAAAmAAAACAAAAD2wAAAAAAAA"/>
+                <pr:smNativeData xmlns:pr="smNativeData" xmlns="smNativeData" val="SMDATA_15_9kV5ZhMAAAAlAAAAZAAAAA0AAAAAkAAAAJAAAACQAAAAkAAAAAAAAAAAAAAAAAAAAAEAAABQAAAAAAAAAAAA4D8AAAAAAADgPwAAAAAAAOA/AAAAAAAA4D8AAAAAAADgPwAAAAAAAOA/AAAAAAAA4D8AAAAAAADgPwAAAAAAAOA/AAAAAAAA4D8CAAAAjAAAAAAAAAAAAAAAQoX0DP///wgAAAAAAAAAAAAAAAAAAAAAAAAAAAAAAAAAAAAAZAAAAAEAAABAAAAAAAAAAAAAAAAAAAAAAAAAAAAAAAAAAAAAAAAAAAAAAAAAAAAAAAAAAAAAAAAAAAAAAAAAAAAAAAAAAAAAAAAAAAAAAAAAAAAAAAAAAAAAAAAAAAAAFAAAADwAAAAAAAAAAAAAAAAAAAkUAAAAAQAAABQAAAAUAAAAFAAAAAEAAAAAAAAAZAAAAGQAAAAAAAAAZAAAAGQAAAAVAAAAYAAAAAAAAAAAAAAADwAAACADAAAAAAAAAAAAAAEAAACgMgAAVgcAAKr4//8BAAAAf39/AAEAAABkAAAAAAAAABQAAABAHwAAAAAAACYAAAAAAAAAwOD//wAAAAAmAAAAZAAAABYAAABMAAAAAAAAAAAAAAAEAAAAAAAAAAEAAABZWVkKAAAAACgAAAAoAAAAZAAAAGQAAAAAAAAAzMzMAAAAAABQAAAAUAAAAGQAAABkAAAAAAAAABcAAAAUAAAAAAAAAAAAAAD/fwAA/38AAAAAAAAJAAAABAAAAF0AXgAeAAAAaAAAAAAAAAAAAAAAAAAAAAAAAAAAAAAAECcAABAnAAAAAAAAAAAAAAAAAAAAAAAAAAAAAAAAAAAAAAAAAAAAABQAAAAAAAAAwMD/AAAAAABkAAAAMgAAAAAAAABkAAAAAAAAAH9/fwAKAAAAIgAAABgAAAAAAAAAAAAAAAAAAAAAAAAAAAAAAAAAAAAkAAAAJAAAAAAAAAAHAAAAAAAAAAAAAAAAAAAAAAAAAAAAAAAAAAAAf39/ACUAAABYAAAAAAAAAAAAAAAAAAAAAAAAAAAAAAAAAAAAAAAAAAAAAAAAAAAAAAAAAAAAAAA/AAAAAAAAAKCGAQAAAAAAAAAAAAAAAAAMAAAAAQAAAAAAAAAAAAAAAAAAAB8AAABUAAAAAAAABQAAAAEAAAAAAAAAAAAAAAAAAAAAAAAAAAAAAAAAAAAAAAAAAAAAAAJ/f38AAAAAA8zMzADAwP8Af39/AAAAAAAAAAAAAAAAAAAAAAAAAAAAIQAAABgAAAAUAAAAFAMAALwGAAB/NwAAARcAABAAAAAmAAAACAAAAD2wAAAAAAAA"/>
               </a:ext>
             </a:extLst>
           </p:cNvSpPr>
@@ -5078,7 +5078,7 @@
             <a:spLocks noGrp="1" noChangeArrowheads="1"/>
             <a:extLst>
               <a:ext uri="smNativeData">
-                <pr:smNativeData xmlns:pr="smNativeData" xmlns="smNativeData" val="SMDATA_15_FUV5ZhMAAAAlAAAAZAAAAA0AAAAAkAAAAJAAAACQAAAAkAAAAAAAAAAAAAAAAAAAAAEAAABQAAAAAAAAAAAA4D8AAAAAAADgPwAAAAAAAOA/AAAAAAAA4D8AAAAAAADgPwAAAAAAAOA/AAAAAAAA4D8AAAAAAADgPwAAAAAAAOA/AAAAAAAA4D8CAAAAjAAAAAAAAAAAAAAAQoX0DP///wgAAAAAAAAAAAAAAAAAAAAAAAAAAAAAAAAAAAAAZAAAAAEAAABAAAAAAAAAAAAAAAAAAAAAAAAAAAAAAAAAAAAAAAAAAAAAAAAAAAAAAAAAAAAAAAAAAAAAAAAAAAAAAAAAAAAAAAAAAAAAAAAAAAAAAAAAAAAAAAAAAAAAFAAAADwAAAAAAAAAAAAAAAAAAAkUAAAAAQAAABQAAAAUAAAAFAAAAAEAAAAAAAAAZAAAAGQAAAAAAAAAZAAAAGQAAAAVAAAAYAAAAAAAAAAAAAAADwAAACADAAAAAAAAAAAAAAEAAACgMgAAVgcAAKr4//8BAAAAf39/AAEAAABkAAAAAAAAABQAAABAHwAAAAAAACYAAAAAAAAAwOD//wAAAAAmAAAAZAAAABYAAABMAAAAAAAAAAAAAAAEAAAAAAAAAAEAAABZWVkKAAAAACgAAAAoAAAAZAAAAGQAAAAAAAAAzMzMAAAAAABQAAAAUAAAAGQAAABkAAAAAAAAABcAAAAUAAAAAAAAAAAAAAD/fwAA/38AAAAAAAAJAAAABAAAAAAAAAAeAAAAaAAAAAAAAAAAAAAAAAAAAAAAAAAAAAAAECcAABAnAAAAAAAAAAAAAAAAAAAAAAAAAAAAAAAAAAAAAAAAAAAAABQAAAAAAAAAwMD/AAAAAABkAAAAMgAAAAAAAABkAAAAAAAAAH9/fwAKAAAAIgAAABgAAAAAAAAAAAAAAAAAAAAAAAAAAAAAAAAAAAAkAAAAJAAAAAAAAAAHAAAAAAAAAAAAAAAAAAAAAAAAAAAAAAAAAAAAf39/ACUAAABYAAAAAAAAAAAAAAAAAAAAAAAAAAAAAAAAAAAAAAAAAAAAAAAAAAAAAAAAAAAAAAA/AAAAAAAAAKCGAQAAAAAAAAAAAAAAAAAMAAAAAQAAAAAAAAAAAAAAAAAAAB8AAABUAAAAAAAABQAAAAEAAAAAAAAAAAAAAAAAAAAAAAAAAAAAAAAAAAAAAAAAAAAAAAJ/f38AAAAAA8zMzADAwP8Af39/AAAAAAAAAAAAAAAAAAAAAAAAAAAAIQAAABgAAAAUAAAAFAMAAMADAAALMwAAQQoAABAAAAAmAAAACAAAAD2wAAAAAAAA"/>
+                <pr:smNativeData xmlns:pr="smNativeData" xmlns="smNativeData" val="SMDATA_15_9kV5ZhMAAAAlAAAAZAAAAA0AAAAAkAAAAJAAAACQAAAAkAAAAAAAAAAAAAAAAAAAAAEAAABQAAAAAAAAAAAA4D8AAAAAAADgPwAAAAAAAOA/AAAAAAAA4D8AAAAAAADgPwAAAAAAAOA/AAAAAAAA4D8AAAAAAADgPwAAAAAAAOA/AAAAAAAA4D8CAAAAjAAAAAAAAAAAAAAAQoX0DP///wgAAAAAAAAAAAAAAAAAAAAAAAAAAAAAAAAAAAAAZAAAAAEAAABAAAAAAAAAAAAAAAAAAAAAAAAAAAAAAAAAAAAAAAAAAAAAAAAAAAAAAAAAAAAAAAAAAAAAAAAAAAAAAAAAAAAAAAAAAAAAAAAAAAAAAAAAAAAAAAAAAAAAFAAAADwAAAAAAAAAAAAAAAAAAAkUAAAAAQAAABQAAAAUAAAAFAAAAAEAAAAAAAAAZAAAAGQAAAAAAAAAZAAAAGQAAAAVAAAAYAAAAAAAAAAAAAAADwAAACADAAAAAAAAAAAAAAEAAACgMgAAVgcAAKr4//8BAAAAf39/AAEAAABkAAAAAAAAABQAAABAHwAAAAAAACYAAAAAAAAAwOD//wAAAAAmAAAAZAAAABYAAABMAAAAAAAAAAAAAAAEAAAAAAAAAAEAAABZWVkKAAAAACgAAAAoAAAAZAAAAGQAAAAAAAAAzMzMAAAAAABQAAAAUAAAAGQAAABkAAAAAAAAABcAAAAUAAAAAAAAAAAAAAD/fwAA/38AAAAAAAAJAAAABAAAAAAAAAAeAAAAaAAAAAAAAAAAAAAAAAAAAAAAAAAAAAAAECcAABAnAAAAAAAAAAAAAAAAAAAAAAAAAAAAAAAAAAAAAAAAAAAAABQAAAAAAAAAwMD/AAAAAABkAAAAMgAAAAAAAABkAAAAAAAAAH9/fwAKAAAAIgAAABgAAAAAAAAAAAAAAAAAAAAAAAAAAAAAAAAAAAAkAAAAJAAAAAAAAAAHAAAAAAAAAAAAAAAAAAAAAAAAAAAAAAAAAAAAf39/ACUAAABYAAAAAAAAAAAAAAAAAAAAAAAAAAAAAAAAAAAAAAAAAAAAAAAAAAAAAAAAAAAAAAA/AAAAAAAAAKCGAQAAAAAAAAAAAAAAAAAMAAAAAQAAAAAAAAAAAAAAAAAAAB8AAABUAAAAAAAABQAAAAEAAAAAAAAAAAAAAAAAAAAAAAAAAAAAAAAAAAAAAAAAAAAAAAJ/f38AAAAAA8zMzADAwP8Af39/AAAAAAAAAAAAAAAAAAAAAAAAAAAAIQAAABgAAAAUAAAAFAMAAMADAAALMwAAQQoAABAAAAAmAAAACAAAAD2wAAAAAAAA"/>
               </a:ext>
             </a:extLst>
           </p:cNvSpPr>
@@ -5265,7 +5265,7 @@
             <a:spLocks noGrp="1" noChangeArrowheads="1"/>
             <a:extLst>
               <a:ext uri="smNativeData">
-                <pr:smNativeData xmlns:pr="smNativeData" xmlns="smNativeData" val="SMDATA_15_FUV5ZhMAAAAlAAAAZAAAAA0AAAAAkAAAAJAAAACQAAAAkAAAAAAAAAAAAAAAAAAAAAEAAABQAAAAAAAAAAAA4D8AAAAAAADgPwAAAAAAAOA/AAAAAAAA4D8AAAAAAADgPwAAAAAAAOA/AAAAAAAA4D8AAAAAAADgPwAAAAAAAOA/AAAAAAAA4D8CAAAAjAAAAAAAAAAAAAAAQoX0DP///wgAAAAAAAAAAAAAAAAAAAAAAAAAAAAAAAAAAAAAZAAAAAEAAABAAAAAAAAAAAAAAAAAAAAAAAAAAAAAAAAAAAAAAAAAAAAAAAAAAAAAAAAAAAAAAAAAAAAAAAAAAAAAAAAAAAAAAAAAAAAAAAAAAAAAAAAAAAAAAAAAAAAAFAAAADwAAAAAAAAAAAAAAAAAAAkUAAAAAQAAABQAAAAUAAAAFAAAAAEAAAAAAAAAZAAAAGQAAAAAAAAAZAAAAGQAAAAVAAAAYAAAAAAAAAAAAAAADwAAACADAAAAAAAAAAAAAAEAAACgMgAAVgcAAKr4//8BAAAAf39/AAEAAABkAAAAAAAAABQAAABAHwAAAAAAACYAAAAAAAAAwOD//wAAAAAmAAAAZAAAABYAAABMAAAAAAAAAAAAAAAEAAAAAAAAAAEAAABZWVkKAAAAACgAAAAoAAAAZAAAAGQAAAAAAAAAzMzMAAAAAABQAAAAUAAAAGQAAABkAAAAAAAAABcAAAAUAAAAAAAAAAAAAAD/fwAA/38AAAAAAAAJAAAABAAAAAAAAAAeAAAAaAAAAAAAAAAAAAAAAAAAAAAAAAAAAAAAECcAABAnAAAAAAAAAAAAAAAAAAAAAAAAAAAAAAAAAAAAAAAAAAAAABQAAAAAAAAAwMD/AAAAAABkAAAAMgAAAAAAAABkAAAAAAAAAH9/fwAKAAAAIgAAABgAAAAAAAAAAAAAAAAAAAAAAAAAAAAAAAAAAAAkAAAAJAAAAAAAAAAHAAAAAAAAAAAAAAAAAAAAAAAAAAAAAAAAAAAAf39/ACUAAABYAAAAAAAAAAAAAAAAAAAAAAAAAAAAAAAAAAAAAAAAAAAAAAAAAAAAAAAAAAAAAAA/AAAAAAAAAKCGAQAAAAAAAAAAAAAAAAAMAAAAAQAAAAAAAAAAAAAAAAAAAB8AAABUAAAAAAAABQAAAAEAAAAAAAAAAAAAAAAAAAAAAAAAAAAAAAAAAAAAAAAAAAAAAAJ/f38AAAAAA8zMzADAwP8Af39/AAAAAAAAAAAAAAAAAAAAAAAAAAAAIQAAABgAAAAUAAAAShMAAK8ZAABQNwAAgB4AABAAAAAmAAAACAAAAD2wAAAAAAAA"/>
+                <pr:smNativeData xmlns:pr="smNativeData" xmlns="smNativeData" val="SMDATA_15_9kV5ZhMAAAAlAAAAZAAAAA0AAAAAkAAAAJAAAACQAAAAkAAAAAAAAAAAAAAAAAAAAAEAAABQAAAAAAAAAAAA4D8AAAAAAADgPwAAAAAAAOA/AAAAAAAA4D8AAAAAAADgPwAAAAAAAOA/AAAAAAAA4D8AAAAAAADgPwAAAAAAAOA/AAAAAAAA4D8CAAAAjAAAAAAAAAAAAAAAQoX0DP///wgAAAAAAAAAAAAAAAAAAAAAAAAAAAAAAAAAAAAAZAAAAAEAAABAAAAAAAAAAAAAAAAAAAAAAAAAAAAAAAAAAAAAAAAAAAAAAAAAAAAAAAAAAAAAAAAAAAAAAAAAAAAAAAAAAAAAAAAAAAAAAAAAAAAAAAAAAAAAAAAAAAAAFAAAADwAAAAAAAAAAAAAAAAAAAkUAAAAAQAAABQAAAAUAAAAFAAAAAEAAAAAAAAAZAAAAGQAAAAAAAAAZAAAAGQAAAAVAAAAYAAAAAAAAAAAAAAADwAAACADAAAAAAAAAAAAAAEAAACgMgAAVgcAAKr4//8BAAAAf39/AAEAAABkAAAAAAAAABQAAABAHwAAAAAAACYAAAAAAAAAwOD//wAAAAAmAAAAZAAAABYAAABMAAAAAAAAAAAAAAAEAAAAAAAAAAEAAABZWVkKAAAAACgAAAAoAAAAZAAAAGQAAAAAAAAAzMzMAAAAAABQAAAAUAAAAGQAAABkAAAAAAAAABcAAAAUAAAAAAAAAAAAAAD/fwAA/38AAAAAAAAJAAAABAAAAAAAAAAeAAAAaAAAAAAAAAAAAAAAAAAAAAAAAAAAAAAAECcAABAnAAAAAAAAAAAAAAAAAAAAAAAAAAAAAAAAAAAAAAAAAAAAABQAAAAAAAAAwMD/AAAAAABkAAAAMgAAAAAAAABkAAAAAAAAAH9/fwAKAAAAIgAAABgAAAAAAAAAAAAAAAAAAAAAAAAAAAAAAAAAAAAkAAAAJAAAAAAAAAAHAAAAAAAAAAAAAAAAAAAAAAAAAAAAAAAAAAAAf39/ACUAAABYAAAAAAAAAAAAAAAAAAAAAAAAAAAAAAAAAAAAAAAAAAAAAAAAAAAAAAAAAAAAAAA/AAAAAAAAAKCGAQAAAAAAAAAAAAAAAAAMAAAAAQAAAAAAAAAAAAAAAAAAAB8AAABUAAAAAAAABQAAAAEAAAAAAAAAAAAAAAAAAAAAAAAAAAAAAAAAAAAAAAAAAAAAAAJ/f38AAAAAA8zMzADAwP8Af39/AAAAAAAAAAAAAAAAAAAAAAAAAAAAIQAAABgAAAAUAAAAShMAAK8ZAABQNwAAgB4AABAAAAAmAAAACAAAAD2wAAAAAAAA"/>
               </a:ext>
             </a:extLst>
           </p:cNvSpPr>
@@ -5452,7 +5452,7 @@
             <a:spLocks noGrp="1" noChangeArrowheads="1"/>
             <a:extLst>
               <a:ext uri="smNativeData">
-                <pr:smNativeData xmlns:pr="smNativeData" xmlns="smNativeData" val="SMDATA_15_FUV5ZhMAAAAlAAAAZAAAAA0AAAAAkAAAAJAAAACQAAAAkAAAAAAAAAAAAAAAAAAAAAEAAABQAAAAAAAAAAAA4D8AAAAAAADgPwAAAAAAAOA/AAAAAAAA4D8AAAAAAADgPwAAAAAAAOA/AAAAAAAA4D8AAAAAAADgPwAAAAAAAOA/AAAAAAAA4D8CAAAAjAAAAAAAAAAAAAAAQoX0DP///wgAAAAAAAAAAAAAAAAAAAAAAAAAAAAAAAAAAAAAZAAAAAEAAABAAAAAAAAAAAAAAAAAAAAAAAAAAAAAAAAAAAAAAAAAAAAAAAAAAAAAAAAAAAAAAAAAAAAAAAAAAAAAAAAAAAAAAAAAAAAAAAAAAAAAAAAAAAAAAAAAAAAAFAAAADwAAAAAAAAAAAAAAAAAAAkUAAAAAQAAABQAAAAUAAAAFAAAAAEAAAAAAAAAZAAAAGQAAAAAAAAAZAAAAGQAAAAVAAAAYAAAAAAAAAAAAAAADwAAACADAAAAAAAAAAAAAAEAAACgMgAAVgcAAKr4//8BAAAAf39/AAEAAABkAAAAAAAAABQAAABAHwAAAAAAACYAAAAAAAAAwOD//wAAAAAmAAAAZAAAABYAAABMAAAAAAAAAAAAAAAEAAAAAAAAAAEAAABZWVkKAAAAACgAAAAoAAAAZAAAAGQAAAAAAAAAzMzMAAAAAABQAAAAUAAAAGQAAABkAAAAAAAAABcAAAAUAAAAAAAAAAAAAAD/fwAA/38AAAAAAAAJAAAABAAAAADvvg8eAAAAaAAAAAAAAAAAAAAAAAAAAAAAAAAAAAAAECcAABAnAAAAAAAAAAAAAAAAAAAAAAAAAAAAAAAAAAAAAAAAAAAAABQAAAAAAAAAwMD/AAAAAABkAAAAMgAAAAAAAABkAAAAAAAAAH9/fwAKAAAAIgAAABgAAAAAAAAAAAAAAAAAAAAAAAAAAAAAAAAAAAAkAAAAJAAAAAAAAAAHAAAAAAAAAAAAAAAAAAAAAAAAAAAAAAAAAAAAf39/ACUAAABYAAAAAAAAAAAAAAAAAAAAAAAAAAAAAAAAAAAAAAAAAAAAAAAAAAAAAAAAAAAAAAA/AAAAAAAAAKCGAQAAAAAAAAAAAAAAAAAMAAAAAQAAAAAAAAAAAAAAAAAAAB8AAABUAAAAAAAABQAAAAEAAAAAAAAAAAAAAAAAAAAAAAAAAAAAAAAAAAAAAAAAAAAAAAJ/f38AAAAAA8zMzADAwP8Af39/AAAAAAAAAAAAAAAAAAAAAAAAAAAAIQAAABgAAAAUAAAAShMAACUcAABQNwAApSIAABAAAAAmAAAACAAAAD2wAAAAAAAA"/>
+                <pr:smNativeData xmlns:pr="smNativeData" xmlns="smNativeData" val="SMDATA_15_9kV5ZhMAAAAlAAAAZAAAAA0AAAAAkAAAAJAAAACQAAAAkAAAAAAAAAAAAAAAAAAAAAEAAABQAAAAAAAAAAAA4D8AAAAAAADgPwAAAAAAAOA/AAAAAAAA4D8AAAAAAADgPwAAAAAAAOA/AAAAAAAA4D8AAAAAAADgPwAAAAAAAOA/AAAAAAAA4D8CAAAAjAAAAAAAAAAAAAAAQoX0DP///wgAAAAAAAAAAAAAAAAAAAAAAAAAAAAAAAAAAAAAZAAAAAEAAABAAAAAAAAAAAAAAAAAAAAAAAAAAAAAAAAAAAAAAAAAAAAAAAAAAAAAAAAAAAAAAAAAAAAAAAAAAAAAAAAAAAAAAAAAAAAAAAAAAAAAAAAAAAAAAAAAAAAAFAAAADwAAAAAAAAAAAAAAAAAAAkUAAAAAQAAABQAAAAUAAAAFAAAAAEAAAAAAAAAZAAAAGQAAAAAAAAAZAAAAGQAAAAVAAAAYAAAAAAAAAAAAAAADwAAACADAAAAAAAAAAAAAAEAAACgMgAAVgcAAKr4//8BAAAAf39/AAEAAABkAAAAAAAAABQAAABAHwAAAAAAACYAAAAAAAAAwOD//wAAAAAmAAAAZAAAABYAAABMAAAAAAAAAAAAAAAEAAAAAAAAAAEAAABZWVkKAAAAACgAAAAoAAAAZAAAAGQAAAAAAAAAzMzMAAAAAABQAAAAUAAAAGQAAABkAAAAAAAAABcAAAAUAAAAAAAAAAAAAAD/fwAA/38AAAAAAAAJAAAABAAAAADvvg8eAAAAaAAAAAAAAAAAAAAAAAAAAAAAAAAAAAAAECcAABAnAAAAAAAAAAAAAAAAAAAAAAAAAAAAAAAAAAAAAAAAAAAAABQAAAAAAAAAwMD/AAAAAABkAAAAMgAAAAAAAABkAAAAAAAAAH9/fwAKAAAAIgAAABgAAAAAAAAAAAAAAAAAAAAAAAAAAAAAAAAAAAAkAAAAJAAAAAAAAAAHAAAAAAAAAAAAAAAAAAAAAAAAAAAAAAAAAAAAf39/ACUAAABYAAAAAAAAAAAAAAAAAAAAAAAAAAAAAAAAAAAAAAAAAAAAAAAAAAAAAAAAAAAAAAA/AAAAAAAAAKCGAQAAAAAAAAAAAAAAAAAMAAAAAQAAAAAAAAAAAAAAAAAAAB8AAABUAAAAAAAABQAAAAEAAAAAAAAAAAAAAAAAAAAAAAAAAAAAAAAAAAAAAAAAAAAAAAJ/f38AAAAAA8zMzADAwP8Af39/AAAAAAAAAAAAAAAAAAAAAAAAAAAAIQAAABgAAAAUAAAAShMAACUcAABQNwAApSIAABAAAAAmAAAACAAAAD2wAAAAAAAA"/>
               </a:ext>
             </a:extLst>
           </p:cNvSpPr>
@@ -5639,7 +5639,7 @@
             <a:spLocks noGrp="1" noChangeArrowheads="1"/>
             <a:extLst>
               <a:ext uri="smNativeData">
-                <pr:smNativeData xmlns:pr="smNativeData" xmlns="smNativeData" val="SMDATA_15_FUV5ZhMAAAAlAAAAZAAAAA0AAAAAkAAAAJAAAACQAAAAkAAAAAAAAAAAAAAAAAAAAAEAAABQAAAAAAAAAAAA4D8AAAAAAADgPwAAAAAAAOA/AAAAAAAA4D8AAAAAAADgPwAAAAAAAOA/AAAAAAAA4D8AAAAAAADgPwAAAAAAAOA/AAAAAAAA4D8CAAAAjAAAAAAAAAAAAAAAQoX0DP///wgAAAAAAAAAAAAAAAAAAAAAAAAAAAAAAAAAAAAAZAAAAAEAAABAAAAAAAAAAAAAAAAAAAAAAAAAAAAAAAAAAAAAAAAAAAAAAAAAAAAAAAAAAAAAAAAAAAAAAAAAAAAAAAAAAAAAAAAAAAAAAAAAAAAAAAAAAAAAAAAAAAAAFAAAADwAAAAAAAAAAAAAAAAAAAkUAAAAAQAAABQAAAAUAAAAFAAAAAEAAAAAAAAAZAAAAGQAAAAAAAAAZAAAAGQAAAAVAAAAYAAAAAAAAAAAAAAADwAAACADAAAAAAAAAAAAAAEAAACgMgAAVgcAAKr4//8BAAAAf39/AAEAAABkAAAAAAAAABQAAABAHwAAAAAAACYAAAAAAAAAwOD//wAAAAAmAAAAZAAAABYAAABMAAAAAAAAAAAAAAAEAAAAAAAAAAEAAABZWVkKAAAAACgAAAAoAAAAZAAAAGQAAAAAAAAAzMzMAAAAAABQAAAAUAAAAGQAAABkAAAAAAAAABcAAAAUAAAAAAAAAAAAAAD/fwAA/38AAAAAAAAJAAAABAAAAIAmcwceAAAAaAAAAAAAAAAAAAAAAAAAAAAAAAAAAAAAECcAABAnAAAAAAAAAAAAAAAAAAAAAAAAAAAAAAAAAAAAAAAAAAAAABQAAAAAAAAAwMD/AAAAAABkAAAAMgAAAAAAAABkAAAAAAAAAH9/fwAKAAAAIgAAABgAAAAAAAAAAAAAAAAAAAAAAAAAAAAAAAAAAAAkAAAAJAAAAAAAAAAHAAAAAAAAAAAAAAAAAAAAAAAAAAAAAAAAAAAAf39/ACUAAABYAAAAAAAAAAAAAAAAAAAAAAAAAAAAAAAAAAAAAAAAAAAAAAAAAAAAAAAAAAAAAAA/AAAAAAAAAKCGAQAAAAAAAAAAAAAAAAAMAAAAAQAAAAAAAAAAAAAAAAAAAB8AAABUAAAAAAAABQAAAAEAAAAAAAAAAAAAAAAAAAAAAAAAAAAAAAAAAAAAAAAAAAAAAAJ/f38AAAAAA8zMzADAwP8Af39/AAAAAAAAAAAAAAAAAAAAAAAAAAAAIQAAABgAAAAUAAAAShMAAEofAABQNwAAwycAABAAAAAmAAAACAAAAD2wAAAAAAAA"/>
+                <pr:smNativeData xmlns:pr="smNativeData" xmlns="smNativeData" val="SMDATA_15_9kV5ZhMAAAAlAAAAZAAAAA0AAAAAkAAAAJAAAACQAAAAkAAAAAAAAAAAAAAAAAAAAAEAAABQAAAAAAAAAAAA4D8AAAAAAADgPwAAAAAAAOA/AAAAAAAA4D8AAAAAAADgPwAAAAAAAOA/AAAAAAAA4D8AAAAAAADgPwAAAAAAAOA/AAAAAAAA4D8CAAAAjAAAAAAAAAAAAAAAQoX0DP///wgAAAAAAAAAAAAAAAAAAAAAAAAAAAAAAAAAAAAAZAAAAAEAAABAAAAAAAAAAAAAAAAAAAAAAAAAAAAAAAAAAAAAAAAAAAAAAAAAAAAAAAAAAAAAAAAAAAAAAAAAAAAAAAAAAAAAAAAAAAAAAAAAAAAAAAAAAAAAAAAAAAAAFAAAADwAAAAAAAAAAAAAAAAAAAkUAAAAAQAAABQAAAAUAAAAFAAAAAEAAAAAAAAAZAAAAGQAAAAAAAAAZAAAAGQAAAAVAAAAYAAAAAAAAAAAAAAADwAAACADAAAAAAAAAAAAAAEAAACgMgAAVgcAAKr4//8BAAAAf39/AAEAAABkAAAAAAAAABQAAABAHwAAAAAAACYAAAAAAAAAwOD//wAAAAAmAAAAZAAAABYAAABMAAAAAAAAAAAAAAAEAAAAAAAAAAEAAABZWVkKAAAAACgAAAAoAAAAZAAAAGQAAAAAAAAAzMzMAAAAAABQAAAAUAAAAGQAAABkAAAAAAAAABcAAAAUAAAAAAAAAAAAAAD/fwAA/38AAAAAAAAJAAAABAAAAIAmcwceAAAAaAAAAAAAAAAAAAAAAAAAAAAAAAAAAAAAECcAABAnAAAAAAAAAAAAAAAAAAAAAAAAAAAAAAAAAAAAAAAAAAAAABQAAAAAAAAAwMD/AAAAAABkAAAAMgAAAAAAAABkAAAAAAAAAH9/fwAKAAAAIgAAABgAAAAAAAAAAAAAAAAAAAAAAAAAAAAAAAAAAAAkAAAAJAAAAAAAAAAHAAAAAAAAAAAAAAAAAAAAAAAAAAAAAAAAAAAAf39/ACUAAABYAAAAAAAAAAAAAAAAAAAAAAAAAAAAAAAAAAAAAAAAAAAAAAAAAAAAAAAAAAAAAAA/AAAAAAAAAKCGAQAAAAAAAAAAAAAAAAAMAAAAAQAAAAAAAAAAAAAAAAAAAB8AAABUAAAAAAAABQAAAAEAAAAAAAAAAAAAAAAAAAAAAAAAAAAAAAAAAAAAAAAAAAAAAAJ/f38AAAAAA8zMzADAwP8Af39/AAAAAAAAAAAAAAAAAAAAAAAAAAAAIQAAABgAAAAUAAAAShMAAEofAABQNwAAwycAABAAAAAmAAAACAAAAD2wAAAAAAAA"/>
               </a:ext>
             </a:extLst>
           </p:cNvSpPr>
@@ -5852,7 +5852,7 @@
             <a:spLocks noGrp="1" noChangeArrowheads="1"/>
             <a:extLst>
               <a:ext uri="smNativeData">
-                <pr:smNativeData xmlns:pr="smNativeData" xmlns="smNativeData" val="SMDATA_15_FUV5ZhMAAAAlAAAAZAAAAA0AAAAAkAAAAJAAAACQAAAAkAAAAAAAAAABAAAAAAAAAAEAAABQAAAAAAAAAAAA4D8AAAAAAADgPwAAAAAAAOA/AAAAAAAA4D8AAAAAAADgPwAAAAAAAOA/AAAAAAAA4D8AAAAAAADgPwAAAAAAAOA/AAAAAAAA4D8CAAAAjAAAAAAAAAAAAAAAQoX0DP///wgAAAAAAAAAAAAAAAAAAAAAAAAAAAAAAAAAAAAAZAAAAAEAAABAAAAAAAAAAAAAAAAAAAAAAAAAAAAAAAAAAAAAAAAAAAAAAAAAAAAAAAAAAAAAAAAAAAAAAAAAAAAAAAAAAAAAAAAAAAAAAAAAAAAAAAAAAAAAAAAAAAAAFAAAADwAAAAAAAAAAAAAAAAAAAkUAAAAAQAAABQAAAAUAAAAFAAAAAEAAAAAAAAAZAAAAGQAAAAAAAAAZAAAAGQAAAAVAAAAYAAAAAAAAAAAAAAADwAAACADAAAAAAAAAAAAAAEAAACgMgAAVgcAAKr4//8BAAAAf39/AAEAAABkAAAAAAAAABQAAABAHwAAAAAAACYAAAAAAAAAwOD//wAAAAAmAAAAZAAAABYAAABMAAAAAAAAAAAAAAAEAAAAAAAAAAEAAABZWVkKAAAAACgAAAAoAAAAZAAAAGQAAAAAAAAAzMzMAAAAAABQAAAAUAAAAGQAAABkAAAAAAAAABcAAAAUAAAAAAAAAAAAAAD/fwAA/38AAAAAAAAJAAAABAAAAF8AYAAeAAAAaAAAAAAAAAAAAAAAAAAAAAAAAAAAAAAAECcAABAnAAAAAAAAAAAAAAAAAAAAAAAAAAAAAAAAAAAAAAAAAAAAABQAAAAAAAAAwMD/AAAAAABkAAAAMgAAAAAAAABkAAAAAAAAAH9/fwAKAAAAIgAAABgAAAAAAAAAAAAAAAAAAAAAAAAAAAAAAAAAAAAkAAAAJAAAAAAAAAAHAAAAAAAAAAAAAAAAAAAAAAAAAAAAAAAAAAAAf39/ACUAAABYAAAAAAAAAAAAAAAAAAAAAAAAAAAAAAAAAAAAAAAAAAAAAAAAAAAAAAAAAAAAAAA/AAAAAAAAAKCGAQAAAAAAAAAAAAAAAAAMAAAAAQAAAAAAAAAAAAAAAAAAAB8AAABUAAAAAAAABQAAAAEAAAAAAAAAAAAAAAAAAAAAAAAAAAAAAAAAAAAAAAAAAAAAAAJ/f38AAAAAA8zMzADAwP8Af39/AAAAAAAAAAAAAAAAAAAAAAAAAAAAIQAAABgAAAAUAAAAHjQAAEAmAAB/NwAAeikAABAAAAAmAAAACAAAADywAAAAAAAA"/>
+                <pr:smNativeData xmlns:pr="smNativeData" xmlns="smNativeData" val="SMDATA_15_9kV5ZhMAAAAlAAAAZAAAAA0AAAAAkAAAAJAAAACQAAAAkAAAAAAAAAABAAAAAAAAAAEAAABQAAAAAAAAAAAA4D8AAAAAAADgPwAAAAAAAOA/AAAAAAAA4D8AAAAAAADgPwAAAAAAAOA/AAAAAAAA4D8AAAAAAADgPwAAAAAAAOA/AAAAAAAA4D8CAAAAjAAAAAAAAAAAAAAAQoX0DP///wgAAAAAAAAAAAAAAAAAAAAAAAAAAAAAAAAAAAAAZAAAAAEAAABAAAAAAAAAAAAAAAAAAAAAAAAAAAAAAAAAAAAAAAAAAAAAAAAAAAAAAAAAAAAAAAAAAAAAAAAAAAAAAAAAAAAAAAAAAAAAAAAAAAAAAAAAAAAAAAAAAAAAFAAAADwAAAAAAAAAAAAAAAAAAAkUAAAAAQAAABQAAAAUAAAAFAAAAAEAAAAAAAAAZAAAAGQAAAAAAAAAZAAAAGQAAAAVAAAAYAAAAAAAAAAAAAAADwAAACADAAAAAAAAAAAAAAEAAACgMgAAVgcAAKr4//8BAAAAf39/AAEAAABkAAAAAAAAABQAAABAHwAAAAAAACYAAAAAAAAAwOD//wAAAAAmAAAAZAAAABYAAABMAAAAAAAAAAAAAAAEAAAAAAAAAAEAAABZWVkKAAAAACgAAAAoAAAAZAAAAGQAAAAAAAAAzMzMAAAAAABQAAAAUAAAAGQAAABkAAAAAAAAABcAAAAUAAAAAAAAAAAAAAD/fwAA/38AAAAAAAAJAAAABAAAAF8AYAAeAAAAaAAAAAAAAAAAAAAAAAAAAAAAAAAAAAAAECcAABAnAAAAAAAAAAAAAAAAAAAAAAAAAAAAAAAAAAAAAAAAAAAAABQAAAAAAAAAwMD/AAAAAABkAAAAMgAAAAAAAABkAAAAAAAAAH9/fwAKAAAAIgAAABgAAAAAAAAAAAAAAAAAAAAAAAAAAAAAAAAAAAAkAAAAJAAAAAAAAAAHAAAAAAAAAAAAAAAAAAAAAAAAAAAAAAAAAAAAf39/ACUAAABYAAAAAAAAAAAAAAAAAAAAAAAAAAAAAAAAAAAAAAAAAAAAAAAAAAAAAAAAAAAAAAA/AAAAAAAAAKCGAQAAAAAAAAAAAAAAAAAMAAAAAQAAAAAAAAAAAAAAAAAAAB8AAABUAAAAAAAABQAAAAEAAAAAAAAAAAAAAAAAAAAAAAAAAAAAAAAAAAAAAAAAAAAAAAJ/f38AAAAAA8zMzADAwP8Af39/AAAAAAAAAAAAAAAAAAAAAAAAAAAAIQAAABgAAAAUAAAAHjQAAEAmAAB/NwAAeikAABAAAAAmAAAACAAAADywAAAAAAAA"/>
               </a:ext>
             </a:extLst>
           </p:cNvSpPr>
@@ -5906,7 +5906,7 @@
               </a:spcAft>
               <a:buNone/>
             </a:pPr>
-            <a:fld id="{3FD94E95-DBD2-8CB8-9C61-2DED002F6A78}" type="slidenum">
+            <a:fld id="{3FDDE997-D9D2-881F-9C65-2F4AA72B6A7A}" type="slidenum">
               <a:rPr lang="ru-ru" cap="none"/>
               <a:t/>
             </a:fld>
@@ -5921,7 +5921,7 @@
             <a:spLocks noGrp="1" noChangeArrowheads="1"/>
             <a:extLst>
               <a:ext uri="smNativeData">
-                <pr:smNativeData xmlns:pr="smNativeData" xmlns="smNativeData" val="SMDATA_15_FUV5ZhMAAAAlAAAAZAAAAA0AAAAAkAAAAJAAAACQAAAAkAAAAAAAAAAAAAAAAAAAAAEAAABQAAAAAAAAAAAA4D8AAAAAAADgPwAAAAAAAOA/AAAAAAAA4D8AAAAAAADgPwAAAAAAAOA/AAAAAAAA4D8AAAAAAADgPwAAAAAAAOA/AAAAAAAA4D8CAAAAjAAAAAAAAAAAAAAAQoX0DP///wgAAAAAAAAAAAAAAAAAAAAAAAAAAAAAAAAAAAAAZAAAAAEAAABAAAAAAAAAAAAAAAAAAAAAAAAAAAAAAAAAAAAAAAAAAAAAAAAAAAAAAAAAAAAAAAAAAAAAAAAAAAAAAAAAAAAAAAAAAAAAAAAAAAAAAAAAAAAAAAAAAAAAFAAAADwAAAAAAAAAAAAAAAAAAAkUAAAAAQAAABQAAAAUAAAAFAAAAAEAAAAAAAAAZAAAAGQAAAAAAAAAZAAAAGQAAAAVAAAAYAAAAAAAAAAAAAAADwAAACADAAAAAAAAAAAAAAEAAACgMgAAVgcAAKr4//8BAAAAf39/AAEAAABkAAAAAAAAABQAAABAHwAAAAAAACYAAAAAAAAAwOD//wAAAAAmAAAAZAAAABYAAABMAAAAAAAAAAAAAAAEAAAAAAAAAAEAAABZWVkKAAAAACgAAAAoAAAAZAAAAGQAAAAAAAAAzMzMAAAAAABQAAAAUAAAAGQAAABkAAAAAAAAABcAAAAUAAAAAAAAAAAAAAD/fwAA/38AAAAAAAAJAAAABAAAAADvvg8eAAAAaAAAAAAAAAAAAAAAAAAAAAAAAAAAAAAAECcAABAnAAAAAAAAAAAAAAAAAAAAAAAAAAAAAAAAAAAAAAAAAAAAABQAAAAAAAAAwMD/AAAAAABkAAAAMgAAAAAAAABkAAAAAAAAAH9/fwAKAAAAIgAAABgAAAAAAAAAAAAAAAAAAAAAAAAAAAAAAAAAAAAkAAAAJAAAAAAAAAAHAAAAAAAAAAAAAAAAAAAAAAAAAAAAAAAAAAAAf39/ACUAAABYAAAAAAAAAAAAAAAAAAAAAAAAAAAAAAAAAAAAAAAAAAAAAAAAAAAAAAAAAAAAAAA/AAAAAAAAAKCGAQAAAAAAAAAAAAAAAAAMAAAAAQAAAAAAAAAAAAAAAAAAAB8AAABUAAAAAAAABQAAAAEAAAAAAAAAAAAAAAAAAAAAAAAAAAAAAAAAAAAAAAAAAAAAAAJ/f38AAAAAA8zMzADAwP8Af39/AAAAAAAAAAAAAAAAAAAAAAAAAAAAIQAAABgAAAAUAAAAFAMAALYCAAB/NwAAvwoAABAAAAAmAAAACAAAADywAAAAAAAA"/>
+                <pr:smNativeData xmlns:pr="smNativeData" xmlns="smNativeData" val="SMDATA_15_9kV5ZhMAAAAlAAAAZAAAAA0AAAAAkAAAAJAAAACQAAAAkAAAAAAAAAAAAAAAAAAAAAEAAABQAAAAAAAAAAAA4D8AAAAAAADgPwAAAAAAAOA/AAAAAAAA4D8AAAAAAADgPwAAAAAAAOA/AAAAAAAA4D8AAAAAAADgPwAAAAAAAOA/AAAAAAAA4D8CAAAAjAAAAAAAAAAAAAAAQoX0DP///wgAAAAAAAAAAAAAAAAAAAAAAAAAAAAAAAAAAAAAZAAAAAEAAABAAAAAAAAAAAAAAAAAAAAAAAAAAAAAAAAAAAAAAAAAAAAAAAAAAAAAAAAAAAAAAAAAAAAAAAAAAAAAAAAAAAAAAAAAAAAAAAAAAAAAAAAAAAAAAAAAAAAAFAAAADwAAAAAAAAAAAAAAAAAAAkUAAAAAQAAABQAAAAUAAAAFAAAAAEAAAAAAAAAZAAAAGQAAAAAAAAAZAAAAGQAAAAVAAAAYAAAAAAAAAAAAAAADwAAACADAAAAAAAAAAAAAAEAAACgMgAAVgcAAKr4//8BAAAAf39/AAEAAABkAAAAAAAAABQAAABAHwAAAAAAACYAAAAAAAAAwOD//wAAAAAmAAAAZAAAABYAAABMAAAAAAAAAAAAAAAEAAAAAAAAAAEAAABZWVkKAAAAACgAAAAoAAAAZAAAAGQAAAAAAAAAzMzMAAAAAABQAAAAUAAAAGQAAABkAAAAAAAAABcAAAAUAAAAAAAAAAAAAAD/fwAA/38AAAAAAAAJAAAABAAAAADvvg8eAAAAaAAAAAAAAAAAAAAAAAAAAAAAAAAAAAAAECcAABAnAAAAAAAAAAAAAAAAAAAAAAAAAAAAAAAAAAAAAAAAAAAAABQAAAAAAAAAwMD/AAAAAABkAAAAMgAAAAAAAABkAAAAAAAAAH9/fwAKAAAAIgAAABgAAAAAAAAAAAAAAAAAAAAAAAAAAAAAAAAAAAAkAAAAJAAAAAAAAAAHAAAAAAAAAAAAAAAAAAAAAAAAAAAAAAAAAAAAf39/ACUAAABYAAAAAAAAAAAAAAAAAAAAAAAAAAAAAAAAAAAAAAAAAAAAAAAAAAAAAAAAAAAAAAA/AAAAAAAAAKCGAQAAAAAAAAAAAAAAAAAMAAAAAQAAAAAAAAAAAAAAAAAAAB8AAABUAAAAAAAABQAAAAEAAAAAAAAAAAAAAAAAAAAAAAAAAAAAAAAAAAAAAAAAAAAAAAJ/f38AAAAAA8zMzADAwP8Af39/AAAAAAAAAAAAAAAAAAAAAAAAAAAAIQAAABgAAAAUAAAAFAMAALYCAAB/NwAAvwoAABAAAAAmAAAACAAAADywAAAAAAAA"/>
               </a:ext>
             </a:extLst>
           </p:cNvSpPr>
@@ -6031,7 +6031,7 @@
             <a:spLocks noGrp="1" noChangeArrowheads="1"/>
             <a:extLst>
               <a:ext uri="smNativeData">
-                <pr:smNativeData xmlns:pr="smNativeData" xmlns="smNativeData" val="SMDATA_15_FUV5ZhMAAAAlAAAAZAAAAE0AAAAAkAAAAJAAAACQAAAAkAAAAAAAAAAAAAAAAAAAAAEAAABQAAAAAAAAAAAA4D8AAAAAAADgPwAAAAAAAOA/AAAAAAAA4D8AAAAAAADgPwAAAAAAAOA/AAAAAAAA4D8AAAAAAADgPwAAAAAAAOA/AAAAAAAA4D8CAAAAjAAAAAAAAAAAAAAAQoX0DP///wgAAAAAAAAAAAAAAAAAAAAAAAAAAAAAAAAAAAAAZAAAAAEAAABAAAAAAAAAAAAAAAAAAAAAAAAAAAAAAAAAAAAAAAAAAAAAAAAAAAAAAAAAAAAAAAAAAAAAAAAAAAAAAAAAAAAAAAAAAAAAAAAAAAAAAAAAAAAAAAAAAAAAFAAAADwAAAAAAAAAAAAAAAAAAAkUAAAAAQAAABQAAAAUAAAAFAAAAAEAAAAAAAAAZAAAAGQAAAAAAAAAZAAAAGQAAAAVAAAAYAAAAAAAAAAAAAAADwAAACADAAAAAAAAAAAAAAEAAACgMgAAVgcAAKr4//8BAAAAf39/AAEAAABkAAAAAAAAABQAAABAHwAAAAAAACYAAAAAAAAAwOD//wAAAAAmAAAAZAAAABYAAABMAAAAAAAAAAAAAAAEAAAAAAAAAAEAAABZWVkKAAAAACgAAAAoAAAAZAAAAGQAAAAAAAAAzMzMAAAAAABQAAAAUAAAAGQAAABkAAAAAAAAABcAAAAUAAAAAAAAAAAAAAD/fwAA/38AAAAAAAAJAAAABAAAAGdlODkeAAAAaAAAAAAAAAAAAAAAAAAAAAAAAAAAAAAAECcAABAnAAAAAAAAAAAAAAAAAAAAAAAAAAAAAAAAAAAAAAAAAAAAABQAAAAAAAAAwMD/AAAAAABkAAAAMgAAAAAAAABkAAAAAAAAAH9/fwAKAAAAIgAAABgAAAAAAAAAAAAAAAAAAAAAAAAAAAAAAAAAAAAkAAAAJAAAAAAAAAAHAAAAAAAAAAAAAAAAAAAAAAAAAAAAAAAAAAAAf39/ACUAAABYAAAAAAAAAAAAAAAAAAAAAAAAAAAAAAAAAAAAAAAAAAAAAAAAAAAAAAAAAAAAAAA/AAAAAAAAAKCGAQAAAAAAAAAAAAAAAAAMAAAAAQAAAAAAAAAAAAAAAAAAAB8AAABUAAAAAAAABQAAAAEAAAAAAAAAAAAAAAAAAAAAAAAAAAAAAAAAAAAAAAAAAAAAAAJ/f38AAAAAA8zMzADAwP8Af39/AAAAAAAAAAAAAAAAAAAAAAAAAAAAIQAAABgAAAAUAAAAXAgAALAKAAAUJAAAtiYAABAgAAAmAAAACAAAAD2wAAAAAAAA"/>
+                <pr:smNativeData xmlns:pr="smNativeData" xmlns="smNativeData" val="SMDATA_15_9kV5ZhMAAAAlAAAAZAAAAE0AAAAAkAAAAJAAAACQAAAAkAAAAAAAAAAAAAAAAAAAAAEAAABQAAAAAAAAAAAA4D8AAAAAAADgPwAAAAAAAOA/AAAAAAAA4D8AAAAAAADgPwAAAAAAAOA/AAAAAAAA4D8AAAAAAADgPwAAAAAAAOA/AAAAAAAA4D8CAAAAjAAAAAAAAAAAAAAAQoX0DP///wgAAAAAAAAAAAAAAAAAAAAAAAAAAAAAAAAAAAAAZAAAAAEAAABAAAAAAAAAAAAAAAAAAAAAAAAAAAAAAAAAAAAAAAAAAAAAAAAAAAAAAAAAAAAAAAAAAAAAAAAAAAAAAAAAAAAAAAAAAAAAAAAAAAAAAAAAAAAAAAAAAAAAFAAAADwAAAAAAAAAAAAAAAAAAAkUAAAAAQAAABQAAAAUAAAAFAAAAAEAAAAAAAAAZAAAAGQAAAAAAAAAZAAAAGQAAAAVAAAAYAAAAAAAAAAAAAAADwAAACADAAAAAAAAAAAAAAEAAACgMgAAVgcAAKr4//8BAAAAf39/AAEAAABkAAAAAAAAABQAAABAHwAAAAAAACYAAAAAAAAAwOD//wAAAAAmAAAAZAAAABYAAABMAAAAAAAAAAAAAAAEAAAAAAAAAAEAAABZWVkKAAAAACgAAAAoAAAAZAAAAGQAAAAAAAAAzMzMAAAAAABQAAAAUAAAAGQAAABkAAAAAAAAABcAAAAUAAAAAAAAAAAAAAD/fwAA/38AAAAAAAAJAAAABAAAAGdlODkeAAAAaAAAAAAAAAAAAAAAAAAAAAAAAAAAAAAAECcAABAnAAAAAAAAAAAAAAAAAAAAAAAAAAAAAAAAAAAAAAAAAAAAABQAAAAAAAAAwMD/AAAAAABkAAAAMgAAAAAAAABkAAAAAAAAAH9/fwAKAAAAIgAAABgAAAAAAAAAAAAAAAAAAAAAAAAAAAAAAAAAAAAkAAAAJAAAAAAAAAAHAAAAAAAAAAAAAAAAAAAAAAAAAAAAAAAAAAAAf39/ACUAAABYAAAAAAAAAAAAAAAAAAAAAAAAAAAAAAAAAAAAAAAAAAAAAAAAAAAAAAAAAAAAAAA/AAAAAAAAAKCGAQAAAAAAAAAAAAAAAAAMAAAAAQAAAAAAAAAAAAAAAAAAAB8AAABUAAAAAAAABQAAAAEAAAAAAAAAAAAAAAAAAAAAAAAAAAAAAAAAAAAAAAAAAAAAAAJ/f38AAAAAA8zMzADAwP8Af39/AAAAAAAAAAAAAAAAAAAAAAAAAAAAIQAAABgAAAAUAAAAXAgAALAKAAAUJAAAtiYAABAgAAAmAAAACAAAAD2wAAAAAAAA"/>
               </a:ext>
             </a:extLst>
           </p:cNvSpPr>
@@ -6224,7 +6224,7 @@
             <a:spLocks noGrp="1" noChangeArrowheads="1"/>
             <a:extLst>
               <a:ext uri="smNativeData">
-                <pr:smNativeData xmlns:pr="smNativeData" xmlns="smNativeData" val="SMDATA_15_FUV5ZhMAAAAlAAAAZAAAAA0AAAAAkAAAAJAAAACQAAAAkAAAAAAAAAABAAAAAAAAAAEAAABQAAAAAAAAAAAA4D8AAAAAAADgPwAAAAAAAOA/AAAAAAAA4D8AAAAAAADgPwAAAAAAAOA/AAAAAAAA4D8AAAAAAADgPwAAAAAAAOA/AAAAAAAA4D8CAAAAjAAAAAAAAAAAAAAAQoX0DP///wgAAAAAAAAAAAAAAAAAAAAAAAAAAAAAAAAAAAAAZAAAAAEAAABAAAAAAAAAAAAAAAAAAAAAAAAAAAAAAAAAAAAAAAAAAAAAAAAAAAAAAAAAAAAAAAAAAAAAAAAAAAAAAAAAAAAAAAAAAAAAAAAAAAAAAAAAAAAAAAAAAAAAFAAAADwAAAAAAAAAAAAAAAAAAAkUAAAAAQAAABQAAAAUAAAAFAAAAAEAAAAAAAAAZAAAAGQAAAAAAAAAZAAAAGQAAAAVAAAAYAAAAAAAAAAAAAAADwAAACADAAAAAAAAAAAAAAEAAACgMgAAVgcAAKr4//8BAAAAf39/AAEAAABkAAAAAAAAABQAAABAHwAAAAAAACYAAAAAAAAAwOD//wAAAAAmAAAAZAAAABYAAABMAAAAAAAAAAAAAAAEAAAAAAAAAAEAAABZWVkKAAAAACgAAAAoAAAAZAAAAGQAAAAAAAAAzMzMAAAAAABQAAAAUAAAAGQAAABkAAAAAAAAABcAAAAUAAAAAAAAAAAAAAD/fwAA/38AAAAAAAAJAAAABAAAAAAAAAAeAAAAaAAAAAAAAAAAAAAAAAAAAAAAAAAAAAAAECcAABAnAAAAAAAAAAAAAAAAAAAAAAAAAAAAAAAAAAAAAAAAAAAAABQAAAAAAAAAwMD/AAAAAABkAAAAMgAAAAAAAABkAAAAAAAAAH9/fwAKAAAAIgAAABgAAAAAAAAAAAAAAAAAAAAAAAAAAAAAAAAAAAAkAAAAJAAAAAAAAAAHAAAAAAAAAAAAAAAAAAAAAAAAAAAAAAAAAAAAf39/ACUAAABYAAAAAAAAAAAAAAAAAAAAAAAAAAAAAAAAAAAAAAAAAAAAAAAAAAAAAAAAAAAAAAA/AAAAAAAAAKCGAQAAAAAAAAAAAAAAAAAMAAAAAQAAAAAAAAAAAAAAAAAAAB8AAABUAAAAAAAABQAAAAEAAAAAAAAAAAAAAAAAAAAAAAAAAAAAAAAAAAAAAAAAAAAAAAJ/f38AAAAAA8zMzADAwP8Af39/AAAAAAAAAAAAAAAAAAAAAAAAAAAAIQAAABgAAAAUAAAAHjQAAEAmAAB/NwAAeikAABAAAAAmAAAACAAAADywAAAAAAAA"/>
+                <pr:smNativeData xmlns:pr="smNativeData" xmlns="smNativeData" val="SMDATA_15_9kV5ZhMAAAAlAAAAZAAAAA0AAAAAkAAAAJAAAACQAAAAkAAAAAAAAAABAAAAAAAAAAEAAABQAAAAAAAAAAAA4D8AAAAAAADgPwAAAAAAAOA/AAAAAAAA4D8AAAAAAADgPwAAAAAAAOA/AAAAAAAA4D8AAAAAAADgPwAAAAAAAOA/AAAAAAAA4D8CAAAAjAAAAAAAAAAAAAAAQoX0DP///wgAAAAAAAAAAAAAAAAAAAAAAAAAAAAAAAAAAAAAZAAAAAEAAABAAAAAAAAAAAAAAAAAAAAAAAAAAAAAAAAAAAAAAAAAAAAAAAAAAAAAAAAAAAAAAAAAAAAAAAAAAAAAAAAAAAAAAAAAAAAAAAAAAAAAAAAAAAAAAAAAAAAAFAAAADwAAAAAAAAAAAAAAAAAAAkUAAAAAQAAABQAAAAUAAAAFAAAAAEAAAAAAAAAZAAAAGQAAAAAAAAAZAAAAGQAAAAVAAAAYAAAAAAAAAAAAAAADwAAACADAAAAAAAAAAAAAAEAAACgMgAAVgcAAKr4//8BAAAAf39/AAEAAABkAAAAAAAAABQAAABAHwAAAAAAACYAAAAAAAAAwOD//wAAAAAmAAAAZAAAABYAAABMAAAAAAAAAAAAAAAEAAAAAAAAAAEAAABZWVkKAAAAACgAAAAoAAAAZAAAAGQAAAAAAAAAzMzMAAAAAABQAAAAUAAAAGQAAABkAAAAAAAAABcAAAAUAAAAAAAAAAAAAAD/fwAA/38AAAAAAAAJAAAABAAAAAAAAAAeAAAAaAAAAAAAAAAAAAAAAAAAAAAAAAAAAAAAECcAABAnAAAAAAAAAAAAAAAAAAAAAAAAAAAAAAAAAAAAAAAAAAAAABQAAAAAAAAAwMD/AAAAAABkAAAAMgAAAAAAAABkAAAAAAAAAH9/fwAKAAAAIgAAABgAAAAAAAAAAAAAAAAAAAAAAAAAAAAAAAAAAAAkAAAAJAAAAAAAAAAHAAAAAAAAAAAAAAAAAAAAAAAAAAAAAAAAAAAAf39/ACUAAABYAAAAAAAAAAAAAAAAAAAAAAAAAAAAAAAAAAAAAAAAAAAAAAAAAAAAAAAAAAAAAAA/AAAAAAAAAKCGAQAAAAAAAAAAAAAAAAAMAAAAAQAAAAAAAAAAAAAAAAAAAB8AAABUAAAAAAAABQAAAAEAAAAAAAAAAAAAAAAAAAAAAAAAAAAAAAAAAAAAAAAAAAAAAAJ/f38AAAAAA8zMzADAwP8Af39/AAAAAAAAAAAAAAAAAAAAAAAAAAAAIQAAABgAAAAUAAAAHjQAAEAmAAB/NwAAeikAABAAAAAmAAAACAAAADywAAAAAAAA"/>
               </a:ext>
             </a:extLst>
           </p:cNvSpPr>
@@ -6278,7 +6278,7 @@
               </a:spcAft>
               <a:buNone/>
             </a:pPr>
-            <a:fld id="{3FD95970-3ED2-8CAF-9C61-C8FA172F6A9D}" type="slidenum">
+            <a:fld id="{3FDD8E34-7AD2-8878-9C65-8C2DC02B6AD9}" type="slidenum">
               <a:rPr lang="ru-ru" cap="none"/>
               <a:t/>
             </a:fld>
@@ -6292,7 +6292,7 @@
           <p:cNvPicPr>
             <a:extLst>
               <a:ext uri="smNativeData">
-                <pr:smNativeData xmlns:pr="smNativeData" xmlns="smNativeData" val="SMDATA_17_FUV5ZhMAAAAlAAAAEQAAAA0AAAAAkAAAAEgAAACQAAAASAAAAAAAAAAAAAAAAAAAAAEAAABQAAAAAAAAAAAA4D8AAAAAAADgPwAAAAAAAOA/AAAAAAAA4D8AAAAAAADgPwAAAAAAAOA/AAAAAAAA4D8AAAAAAADgPwAAAAAAAOA/AAAAAAAA4D8CAAAAjAAAAAAAAAAAAAAAQoX0DP///wgAAAAAAAAAAAAAAAAAAAAAAAAAAAAAAAAAAAAAZAAAAAEAAABAAAAAAAAAAAAAAAAAAAAAAAAAAAAAAAAAAAAAAAAAAAAAAAAAAAAAAAAAAAAAAAAAAAAAAAAAAAAAAAAAAAAAAAAAAAAAAAAAAAAAAAAAAAAAAAAAAAAAFAAAADwAAAAAAAAAAAAAAAAAAAkUAAAAAQAAABQAAAAUAAAAFAAAAAEAAAAAAAAAZAAAAGQAAAAAAAAAZAAAAGQAAAAVAAAAYAAAAAAAAAAAAAAADwAAACADAAAAAAAAAAAAAAEAAACgMgAAVgcAAKr4//8BAAAAf39/AAEAAABkAAAAAAAAABQAAABAHwAAAAAAACYAAAAAAAAAwOD//wAAAAAmAAAAZAAAABYAAABMAAAAAAAAAAAAAAAEAAAAAAAAAAEAAABZWVkKAAAAACgAAAAoAAAAZAAAAGQAAAAAAAAAzMzMAAAAAABQAAAAUAAAAGQAAABkAAAAAAAAAAcAAAA4AAAAAAAAAAAAAAAAAAAA////AAAAAAAAAAAAAAAAAAAAAAAAAAAAAAAAAAAAAABkAAAAZAAAAAAAAAAjAAAABAAAAGQAAAAXAAAAFAAAAAAAAAAAAAAA/38AAP9/AAAAAAAACQAAAAQAAACwmIhjHgAAAGgAAAAAAAAAAAAAAAAAAAAAAAAAAAAAABAnAAAQJwAAAAAAAAAAAAAAAAAAAAAAAAAAAAAAAAAAAAAAAAAAAAAUAAAAAAAAAMDA/wAAAAAAZAAAADIAAAAAAAAAZAAAAAAAAAB/f38ACgAAACIAAAAYAAAAAAAAAAAAAAAAAAAAAAAAAAAAAAAAAAAAJAAAACQAAAAAAAAABwAAAAAAAAAAAAAAAAAAAAAAAAAAAAAAAAAAAH9/fwAlAAAAWAAAAAAAAAAAAAAAAAAAAAAAAAAAAAAAAAAAAAAAAAAAAAAAAAAAAAAAAAAAAAAAPwAAAAAAAACghgEAAAAAAAAAAAAAAAAADAAAAAEAAAAAAAAAAAAAAAAAAAAfAAAAVAAAAEKF9AX///8BAAAAAAAAAAAAAAAAAAAAAAAAAAAAAAAAAAAAAAAAAAAAAAACf39/AFlZWQPMzMwAwMD/AH9/fwAAAAAAAAAAAAAAAAD///8AAAAAACEAAAAYAAAAFAAAAAAAAAAAAAAAQDgAADAqAAAQAAAAJgAAAAgAAAD//////////w=="/>
+                <pr:smNativeData xmlns:pr="smNativeData" xmlns="smNativeData" val="SMDATA_17_9kV5ZhMAAAAlAAAAEQAAAA0AAAAAkAAAAEgAAACQAAAASAAAAAAAAAAAAAAAAAAAAAEAAABQAAAAAAAAAAAA4D8AAAAAAADgPwAAAAAAAOA/AAAAAAAA4D8AAAAAAADgPwAAAAAAAOA/AAAAAAAA4D8AAAAAAADgPwAAAAAAAOA/AAAAAAAA4D8CAAAAjAAAAAAAAAAAAAAAQoX0DP///wgAAAAAAAAAAAAAAAAAAAAAAAAAAAAAAAAAAAAAZAAAAAEAAABAAAAAAAAAAAAAAAAAAAAAAAAAAAAAAAAAAAAAAAAAAAAAAAAAAAAAAAAAAAAAAAAAAAAAAAAAAAAAAAAAAAAAAAAAAAAAAAAAAAAAAAAAAAAAAAAAAAAAFAAAADwAAAAAAAAAAAAAAAAAAAkUAAAAAQAAABQAAAAUAAAAFAAAAAEAAAAAAAAAZAAAAGQAAAAAAAAAZAAAAGQAAAAVAAAAYAAAAAAAAAAAAAAADwAAACADAAAAAAAAAAAAAAEAAACgMgAAVgcAAKr4//8BAAAAf39/AAEAAABkAAAAAAAAABQAAABAHwAAAAAAACYAAAAAAAAAwOD//wAAAAAmAAAAZAAAABYAAABMAAAAAAAAAAAAAAAEAAAAAAAAAAEAAABZWVkKAAAAACgAAAAoAAAAZAAAAGQAAAAAAAAAzMzMAAAAAABQAAAAUAAAAGQAAABkAAAAAAAAAAcAAAA4AAAAAAAAAAAAAAAAAAAA////AAAAAAAAAAAAAAAAAAAAAAAAAAAAAAAAAAAAAABkAAAAZAAAAAAAAAAjAAAABAAAAGQAAAAXAAAAFAAAAAAAAAAAAAAA/38AAP9/AAAAAAAACQAAAAQAAACwmIhjHgAAAGgAAAAAAAAAAAAAAAAAAAAAAAAAAAAAABAnAAAQJwAAAAAAAAAAAAAAAAAAAAAAAAAAAAAAAAAAAAAAAAAAAAAUAAAAAAAAAMDA/wAAAAAAZAAAADIAAAAAAAAAZAAAAAAAAAB/f38ACgAAACIAAAAYAAAAAAAAAAAAAAAAAAAAAAAAAAAAAAAAAAAAJAAAACQAAAAAAAAABwAAAAAAAAAAAAAAAAAAAAAAAAAAAAAAAAAAAH9/fwAlAAAAWAAAAAAAAAAAAAAAAAAAAAAAAAAAAAAAAAAAAAAAAAAAAAAAAAAAAAAAAAAAAAAAPwAAAAAAAACghgEAAAAAAAAAAAAAAAAADAAAAAEAAAAAAAAAAAAAAAAAAAAfAAAAVAAAAEKF9AX///8BAAAAAAAAAAAAAAAAAAAAAAAAAAAAAAAAAAAAAAAAAAAAAAACf39/AFlZWQPMzMwAwMD/AH9/fwAAAAAAAAAAAAAAAAD///8AAAAAACEAAAAYAAAAFAAAAAAAAAAAAAAAQDgAADAqAAAQAAAAJgAAAAgAAAD//////////w=="/>
               </a:ext>
             </a:extLst>
           </p:cNvPicPr>
@@ -6326,7 +6326,7 @@
             <a:spLocks noGrp="1" noChangeArrowheads="1"/>
             <a:extLst>
               <a:ext uri="smNativeData">
-                <pr:smNativeData xmlns:pr="smNativeData" xmlns="smNativeData" val="SMDATA_15_FUV5ZhMAAAAlAAAAZAAAAA0AAAAAkAAAAJAAAACQAAAAkAAAAAAAAAABAAAAAAAAAAEAAABQAAAAAAAAAAAA4D8AAAAAAADgPwAAAAAAAOA/AAAAAAAA4D8AAAAAAADgPwAAAAAAAOA/AAAAAAAA4D8AAAAAAADgPwAAAAAAAOA/AAAAAAAA4D8CAAAAjAAAAAAAAAAAAAAAQoX0DP///wgAAAAAAAAAAAAAAAAAAAAAAAAAAAAAAAAAAAAAZAAAAAEAAABAAAAAAAAAAAAAAAAAAAAAAAAAAAAAAAAAAAAAAAAAAAAAAAAAAAAAAAAAAAAAAAAAAAAAAAAAAAAAAAAAAAAAAAAAAAAAAAAAAAAAAAAAAAAAAAAAAAAAFAAAADwAAAAAAAAAAAAAAAAAAAkUAAAAAQAAABQAAAAUAAAAFAAAAAEAAAAAAAAAZAAAAGQAAAAAAAAAZAAAAGQAAAAVAAAAYAAAAAAAAAAAAAAADwAAACADAAAAAAAAAAAAAAEAAACgMgAAVgcAAKr4//8BAAAAf39/AAEAAABkAAAAAAAAABQAAABAHwAAAAAAACYAAAAAAAAAwOD//wAAAAAmAAAAZAAAABYAAABMAAAAAAAAAAAAAAAEAAAAAAAAAAEAAABZWVkKAAAAACgAAAAoAAAAZAAAAGQAAAAAAAAAzMzMAAAAAABQAAAAUAAAAGQAAABkAAAAAAAAABcAAAAUAAAAAAAAAAAAAAD/fwAA/38AAAAAAAAJAAAABAAAAG0AOwAeAAAAaAAAAAAAAAAAAAAAAAAAAAAAAAAAAAAAECcAABAnAAAAAAAAAAAAAAAAAAAAAAAAAAAAAAAAAAAAAAAAAAAAABQAAAAAAAAAwMD/AAAAAABkAAAAMgAAAAAAAABkAAAAAAAAAH9/fwAKAAAAIgAAABgAAAAAAAAAAAAAAAAAAAAAAAAAAAAAAAAAAAAkAAAAJAAAAAAAAAAHAAAAAAAAAAAAAAAAAAAAAAAAAAAAAAAAAAAAf39/ACUAAABYAAAAAAAAAAAAAAAAAAAAAAAAAAAAAAAAAAAAAAAAAAAAAAAAAAAAAAAAAAAAAAA/AAAAAAAAAKCGAQAAAAAAAAAAAAAAAAAMAAAAAQAAAAAAAAAAAAAAAAAAAB8AAABUAAAAAAAABQAAAAEAAAAAAAAAAAAAAAAAAAAAAAAAAAAAAAAAAAAAAAAAAAAAAAJ/f38AAAAAA8zMzADAwP8Af39/AAAAAAAAAAAAAAAAAAAAAAAAAAAAIQAAABgAAAAUAAAA4gUAAEADAAA5NQAAziQAABAAAAAmAAAACAAAAL2wAAAAAAAA"/>
+                <pr:smNativeData xmlns:pr="smNativeData" xmlns="smNativeData" val="SMDATA_15_9kV5ZhMAAAAlAAAAZAAAAA0AAAAAkAAAAJAAAACQAAAAkAAAAAAAAAABAAAAAAAAAAEAAABQAAAAAAAAAAAA4D8AAAAAAADgPwAAAAAAAOA/AAAAAAAA4D8AAAAAAADgPwAAAAAAAOA/AAAAAAAA4D8AAAAAAADgPwAAAAAAAOA/AAAAAAAA4D8CAAAAjAAAAAAAAAAAAAAAQoX0DP///wgAAAAAAAAAAAAAAAAAAAAAAAAAAAAAAAAAAAAAZAAAAAEAAABAAAAAAAAAAAAAAAAAAAAAAAAAAAAAAAAAAAAAAAAAAAAAAAAAAAAAAAAAAAAAAAAAAAAAAAAAAAAAAAAAAAAAAAAAAAAAAAAAAAAAAAAAAAAAAAAAAAAAFAAAADwAAAAAAAAAAAAAAAAAAAkUAAAAAQAAABQAAAAUAAAAFAAAAAEAAAAAAAAAZAAAAGQAAAAAAAAAZAAAAGQAAAAVAAAAYAAAAAAAAAAAAAAADwAAACADAAAAAAAAAAAAAAEAAACgMgAAVgcAAKr4//8BAAAAf39/AAEAAABkAAAAAAAAABQAAABAHwAAAAAAACYAAAAAAAAAwOD//wAAAAAmAAAAZAAAABYAAABMAAAAAAAAAAAAAAAEAAAAAAAAAAEAAABZWVkKAAAAACgAAAAoAAAAZAAAAGQAAAAAAAAAzMzMAAAAAABQAAAAUAAAAGQAAABkAAAAAAAAABcAAAAUAAAAAAAAAAAAAAD/fwAA/38AAAAAAAAJAAAABAAAAG0AOwAeAAAAaAAAAAAAAAAAAAAAAAAAAAAAAAAAAAAAECcAABAnAAAAAAAAAAAAAAAAAAAAAAAAAAAAAAAAAAAAAAAAAAAAABQAAAAAAAAAwMD/AAAAAABkAAAAMgAAAAAAAABkAAAAAAAAAH9/fwAKAAAAIgAAABgAAAAAAAAAAAAAAAAAAAAAAAAAAAAAAAAAAAAkAAAAJAAAAAAAAAAHAAAAAAAAAAAAAAAAAAAAAAAAAAAAAAAAAAAAf39/ACUAAABYAAAAAAAAAAAAAAAAAAAAAAAAAAAAAAAAAAAAAAAAAAAAAAAAAAAAAAAAAAAAAAA/AAAAAAAAAKCGAQAAAAAAAAAAAAAAAAAMAAAAAQAAAAAAAAAAAAAAAAAAAB8AAABUAAAAAAAABQAAAAEAAAAAAAAAAAAAAAAAAAAAAAAAAAAAAAAAAAAAAAAAAAAAAAJ/f38AAAAAA8zMzADAwP8Af39/AAAAAAAAAAAAAAAAAAAAAAAAAAAAIQAAABgAAAAUAAAA4gUAAEADAAA5NQAAziQAABAAAAAmAAAACAAAAL2wAAAAAAAA"/>
               </a:ext>
             </a:extLst>
           </p:cNvSpPr>
@@ -6480,7 +6480,7 @@
             <a:spLocks noGrp="1" noChangeArrowheads="1"/>
             <a:extLst>
               <a:ext uri="smNativeData">
-                <pr:smNativeData xmlns:pr="smNativeData" xmlns="smNativeData" val="SMDATA_15_FUV5ZhMAAAAlAAAAZAAAAA0AAAAAkAAAAJAAAACQAAAAkAAAAAAAAAAAAAAAAAAAAAEAAABQAAAAAAAAAAAA4D8AAAAAAADgPwAAAAAAAOA/AAAAAAAA4D8AAAAAAADgPwAAAAAAAOA/AAAAAAAA4D8AAAAAAADgPwAAAAAAAOA/AAAAAAAA4D8CAAAAjAAAAAAAAAAAAAAAQoX0DP///wgAAAAAAAAAAAAAAAAAAAAAAAAAAAAAAAAAAAAAZAAAAAEAAABAAAAAAAAAAAAAAAAAAAAAAAAAAAAAAAAAAAAAAAAAAAAAAAAAAAAAAAAAAAAAAAAAAAAAAAAAAAAAAAAAAAAAAAAAAAAAAAAAAAAAAAAAAAAAAAAAAAAAFAAAADwAAAAAAAAAAAAAAAAAAAkUAAAAAQAAABQAAAAUAAAAFAAAAAEAAAAAAAAAZAAAAGQAAAAAAAAAZAAAAGQAAAAVAAAAYAAAAAAAAAAAAAAADwAAACADAAAAAAAAAAAAAAEAAACgMgAAVgcAAKr4//8BAAAAf39/AAEAAABkAAAAAAAAABQAAABAHwAAAAAAACYAAAAAAAAAwOD//wAAAAAmAAAAZAAAABYAAABMAAAAAAAAAAAAAAAEAAAAAAAAAAEAAABZWVkKAAAAACgAAAAoAAAAZAAAAGQAAAAAAAAAzMzMAAAAAABQAAAAUAAAAGQAAABkAAAAAAAAABcAAAAUAAAAAAAAAAAAAAD/fwAA/38AAAAAAAAJAAAABAAAAF0AXgAeAAAAaAAAAAAAAAAAAAAAAAAAAAAAAAAAAAAAECcAABAnAAAAAAAAAAAAAAAAAAAAAAAAAAAAAAAAAAAAAAAAAAAAABQAAAAAAAAAwMD/AAAAAABkAAAAMgAAAAAAAABkAAAAAAAAAH9/fwAKAAAAIgAAABgAAAAAAAAAAAAAAAAAAAAAAAAAAAAAAAAAAAAkAAAAJAAAAAAAAAAHAAAAAAAAAAAAAAAAAAAAAAAAAAAAAAAAAAAAf39/ACUAAABYAAAAAAAAAAAAAAAAAAAAAAAAAAAAAAAAAAAAAAAAAAAAAAAAAAAAAAAAAAAAAAA/AAAAAAAAAKCGAQAAAAAAAAAAAAAAAAAMAAAAAQAAAAAAAAAAAAAAAAAAAB8AAABUAAAAAAAABQAAAAEAAAAAAAAAAAAAAAAAAAAAAAAAAAAAAAAAAAAAAAAAAAAAAAJ/f38AAAAAA8zMzADAwP8Af39/AAAAAAAAAAAAAAAAAAAAAAAAAAAAIQAAABgAAAAUAAAAFAMAALYCAAB/NwAAvwoAABAAAAAmAAAACAAAADywAAAAAAAA"/>
+                <pr:smNativeData xmlns:pr="smNativeData" xmlns="smNativeData" val="SMDATA_15_9kV5ZhMAAAAlAAAAZAAAAA0AAAAAkAAAAJAAAACQAAAAkAAAAAAAAAAAAAAAAAAAAAEAAABQAAAAAAAAAAAA4D8AAAAAAADgPwAAAAAAAOA/AAAAAAAA4D8AAAAAAADgPwAAAAAAAOA/AAAAAAAA4D8AAAAAAADgPwAAAAAAAOA/AAAAAAAA4D8CAAAAjAAAAAAAAAAAAAAAQoX0DP///wgAAAAAAAAAAAAAAAAAAAAAAAAAAAAAAAAAAAAAZAAAAAEAAABAAAAAAAAAAAAAAAAAAAAAAAAAAAAAAAAAAAAAAAAAAAAAAAAAAAAAAAAAAAAAAAAAAAAAAAAAAAAAAAAAAAAAAAAAAAAAAAAAAAAAAAAAAAAAAAAAAAAAFAAAADwAAAAAAAAAAAAAAAAAAAkUAAAAAQAAABQAAAAUAAAAFAAAAAEAAAAAAAAAZAAAAGQAAAAAAAAAZAAAAGQAAAAVAAAAYAAAAAAAAAAAAAAADwAAACADAAAAAAAAAAAAAAEAAACgMgAAVgcAAKr4//8BAAAAf39/AAEAAABkAAAAAAAAABQAAABAHwAAAAAAACYAAAAAAAAAwOD//wAAAAAmAAAAZAAAABYAAABMAAAAAAAAAAAAAAAEAAAAAAAAAAEAAABZWVkKAAAAACgAAAAoAAAAZAAAAGQAAAAAAAAAzMzMAAAAAABQAAAAUAAAAGQAAABkAAAAAAAAABcAAAAUAAAAAAAAAAAAAAD/fwAA/38AAAAAAAAJAAAABAAAAF0AXgAeAAAAaAAAAAAAAAAAAAAAAAAAAAAAAAAAAAAAECcAABAnAAAAAAAAAAAAAAAAAAAAAAAAAAAAAAAAAAAAAAAAAAAAABQAAAAAAAAAwMD/AAAAAABkAAAAMgAAAAAAAABkAAAAAAAAAH9/fwAKAAAAIgAAABgAAAAAAAAAAAAAAAAAAAAAAAAAAAAAAAAAAAAkAAAAJAAAAAAAAAAHAAAAAAAAAAAAAAAAAAAAAAAAAAAAAAAAAAAAf39/ACUAAABYAAAAAAAAAAAAAAAAAAAAAAAAAAAAAAAAAAAAAAAAAAAAAAAAAAAAAAAAAAAAAAA/AAAAAAAAAKCGAQAAAAAAAAAAAAAAAAAMAAAAAQAAAAAAAAAAAAAAAAAAAB8AAABUAAAAAAAABQAAAAEAAAAAAAAAAAAAAAAAAAAAAAAAAAAAAAAAAAAAAAAAAAAAAAJ/f38AAAAAA8zMzADAwP8Af39/AAAAAAAAAAAAAAAAAAAAAAAAAAAAIQAAABgAAAAUAAAAFAMAALYCAAB/NwAAvwoAABAAAAAmAAAACAAAADywAAAAAAAA"/>
               </a:ext>
             </a:extLst>
           </p:cNvSpPr>
@@ -6590,7 +6590,7 @@
             <a:spLocks noGrp="1" noChangeArrowheads="1"/>
             <a:extLst>
               <a:ext uri="smNativeData">
-                <pr:smNativeData xmlns:pr="smNativeData" xmlns="smNativeData" val="SMDATA_15_FUV5ZhMAAAAlAAAAZAAAAA0AAAAAkAAAAJAAAACQAAAAkAAAAAAAAAAAAAAAAAAAAAEAAABQAAAAAAAAAAAA4D8AAAAAAADgPwAAAAAAAOA/AAAAAAAA4D8AAAAAAADgPwAAAAAAAOA/AAAAAAAA4D8AAAAAAADgPwAAAAAAAOA/AAAAAAAA4D8CAAAAjAAAAAAAAAAAAAAAQoX0DP///wgAAAAAAAAAAAAAAAAAAAAAAAAAAAAAAAAAAAAAZAAAAAEAAABAAAAAAAAAAAAAAAAAAAAAAAAAAAAAAAAAAAAAAAAAAAAAAAAAAAAAAAAAAAAAAAAAAAAAAAAAAAAAAAAAAAAAAAAAAAAAAAAAAAAAAAAAAAAAAAAAAAAAFAAAADwAAAAAAAAAAAAAAAAAAAkUAAAAAQAAABQAAAAUAAAAFAAAAAEAAAAAAAAAZAAAAGQAAAAAAAAAZAAAAGQAAAAVAAAAYAAAAAAAAAAAAAAADwAAACADAAAAAAAAAAAAAAEAAACgMgAAVgcAAKr4//8BAAAAf39/AAEAAABkAAAAAAAAABQAAABAHwAAAAAAACYAAAAAAAAAwOD//wAAAAAmAAAAZAAAABYAAABMAAAAAAAAAAAAAAAEAAAAAAAAAAEAAABZWVkKAAAAACgAAAAoAAAAZAAAAGQAAAAAAAAAzMzMAAAAAABQAAAAUAAAAGQAAABkAAAAAAAAABcAAAAUAAAAAAAAAAAAAAD/fwAA/38AAAAAAAAJAAAABAAAAAAAAAAeAAAAaAAAAAAAAAAAAAAAAAAAAAAAAAAAAAAAECcAABAnAAAAAAAAAAAAAAAAAAAAAAAAAAAAAAAAAAAAAAAAAAAAABQAAAAAAAAAwMD/AAAAAABkAAAAMgAAAAAAAABkAAAAAAAAAH9/fwAKAAAAIgAAABgAAAAAAAAAAAAAAAAAAAAAAAAAAAAAAAAAAAAkAAAAJAAAAAAAAAAHAAAAAAAAAAAAAAAAAAAAAAAAAAAAAAAAAAAAf39/ACUAAABYAAAAAAAAAAAAAAAAAAAAAAAAAAAAAAAAAAAAAAAAAAAAAAAAAAAAAAAAAAAAAAA/AAAAAAAAAKCGAQAAAAAAAAAAAAAAAAAMAAAAAQAAAAAAAAAAAAAAAAAAAB8AAABUAAAAAAAABQAAAAEAAAAAAAAAAAAAAAAAAAAAAAAAAAAAAAAAAAAAAAAAAAAAAAJ/f38AAAAAA8zMzADAwP8Af39/AAAAAAAAAAAAAAAAAAAAAAAAAAAAIQAAABgAAAAUAAAAwRoAAJQQAADFNQAAZRUAABAAAAAmAAAACAAAAD2wAAAAAAAA"/>
+                <pr:smNativeData xmlns:pr="smNativeData" xmlns="smNativeData" val="SMDATA_15_9kV5ZhMAAAAlAAAAZAAAAA0AAAAAkAAAAJAAAACQAAAAkAAAAAAAAAAAAAAAAAAAAAEAAABQAAAAAAAAAAAA4D8AAAAAAADgPwAAAAAAAOA/AAAAAAAA4D8AAAAAAADgPwAAAAAAAOA/AAAAAAAA4D8AAAAAAADgPwAAAAAAAOA/AAAAAAAA4D8CAAAAjAAAAAAAAAAAAAAAQoX0DP///wgAAAAAAAAAAAAAAAAAAAAAAAAAAAAAAAAAAAAAZAAAAAEAAABAAAAAAAAAAAAAAAAAAAAAAAAAAAAAAAAAAAAAAAAAAAAAAAAAAAAAAAAAAAAAAAAAAAAAAAAAAAAAAAAAAAAAAAAAAAAAAAAAAAAAAAAAAAAAAAAAAAAAFAAAADwAAAAAAAAAAAAAAAAAAAkUAAAAAQAAABQAAAAUAAAAFAAAAAEAAAAAAAAAZAAAAGQAAAAAAAAAZAAAAGQAAAAVAAAAYAAAAAAAAAAAAAAADwAAACADAAAAAAAAAAAAAAEAAACgMgAAVgcAAKr4//8BAAAAf39/AAEAAABkAAAAAAAAABQAAABAHwAAAAAAACYAAAAAAAAAwOD//wAAAAAmAAAAZAAAABYAAABMAAAAAAAAAAAAAAAEAAAAAAAAAAEAAABZWVkKAAAAACgAAAAoAAAAZAAAAGQAAAAAAAAAzMzMAAAAAABQAAAAUAAAAGQAAABkAAAAAAAAABcAAAAUAAAAAAAAAAAAAAD/fwAA/38AAAAAAAAJAAAABAAAAAAAAAAeAAAAaAAAAAAAAAAAAAAAAAAAAAAAAAAAAAAAECcAABAnAAAAAAAAAAAAAAAAAAAAAAAAAAAAAAAAAAAAAAAAAAAAABQAAAAAAAAAwMD/AAAAAABkAAAAMgAAAAAAAABkAAAAAAAAAH9/fwAKAAAAIgAAABgAAAAAAAAAAAAAAAAAAAAAAAAAAAAAAAAAAAAkAAAAJAAAAAAAAAAHAAAAAAAAAAAAAAAAAAAAAAAAAAAAAAAAAAAAf39/ACUAAABYAAAAAAAAAAAAAAAAAAAAAAAAAAAAAAAAAAAAAAAAAAAAAAAAAAAAAAAAAAAAAAA/AAAAAAAAAKCGAQAAAAAAAAAAAAAAAAAMAAAAAQAAAAAAAAAAAAAAAAAAAB8AAABUAAAAAAAABQAAAAEAAAAAAAAAAAAAAAAAAAAAAAAAAAAAAAAAAAAAAAAAAAAAAAJ/f38AAAAAA8zMzADAwP8Af39/AAAAAAAAAAAAAAAAAAAAAAAAAAAAIQAAABgAAAAUAAAAwRoAAJQQAADFNQAAZRUAABAAAAAmAAAACAAAAD2wAAAAAAAA"/>
               </a:ext>
             </a:extLst>
           </p:cNvSpPr>
@@ -6777,7 +6777,7 @@
             <a:spLocks noGrp="1" noChangeArrowheads="1"/>
             <a:extLst>
               <a:ext uri="smNativeData">
-                <pr:smNativeData xmlns:pr="smNativeData" xmlns="smNativeData" val="SMDATA_15_FUV5ZhMAAAAlAAAAZAAAAA0AAAAAkAAAAJAAAACQAAAAkAAAAAAAAAAAAAAAAAAAAAEAAABQAAAAAAAAAAAA4D8AAAAAAADgPwAAAAAAAOA/AAAAAAAA4D8AAAAAAADgPwAAAAAAAOA/AAAAAAAA4D8AAAAAAADgPwAAAAAAAOA/AAAAAAAA4D8CAAAAjAAAAAAAAAAAAAAAQoX0DP///wgAAAAAAAAAAAAAAAAAAAAAAAAAAAAAAAAAAAAAZAAAAAEAAABAAAAAAAAAAAAAAAAAAAAAAAAAAAAAAAAAAAAAAAAAAAAAAAAAAAAAAAAAAAAAAAAAAAAAAAAAAAAAAAAAAAAAAAAAAAAAAAAAAAAAAAAAAAAAAAAAAAAAFAAAADwAAAAAAAAAAAAAAAAAAAkUAAAAAQAAABQAAAAUAAAAFAAAAAEAAAAAAAAAZAAAAGQAAAAAAAAAZAAAAGQAAAAVAAAAYAAAAAAAAAAAAAAADwAAACADAAAAAAAAAAAAAAEAAACgMgAAVgcAAKr4//8BAAAAf39/AAEAAABkAAAAAAAAABQAAABAHwAAAAAAACYAAAAAAAAAwOD//wAAAAAmAAAAZAAAABYAAABMAAAAAAAAAAAAAAAEAAAAAAAAAAEAAABZWVkKAAAAACgAAAAoAAAAZAAAAGQAAAAAAAAAzMzMAAAAAABQAAAAUAAAAGQAAABkAAAAAAAAABcAAAAUAAAAAAAAAAAAAAD/fwAA/38AAAAAAAAJAAAABAAAAAAAAAAeAAAAaAAAAAAAAAAAAAAAAAAAAAAAAAAAAAAAECcAABAnAAAAAAAAAAAAAAAAAAAAAAAAAAAAAAAAAAAAAAAAAAAAABQAAAAAAAAAwMD/AAAAAABkAAAAMgAAAAAAAABkAAAAAAAAAH9/fwAKAAAAIgAAABgAAAAAAAAAAAAAAAAAAAAAAAAAAAAAAAAAAAAkAAAAJAAAAAAAAAAHAAAAAAAAAAAAAAAAAAAAAAAAAAAAAAAAAAAAf39/ACUAAABYAAAAAAAAAAAAAAAAAAAAAAAAAAAAAAAAAAAAAAAAAAAAAAAAAAAAAAAAAAAAAAA/AAAAAAAAAKCGAQAAAAAAAAAAAAAAAAAMAAAAAQAAAAAAAAAAAAAAAAAAAB8AAABUAAAAAAAABQAAAAEAAAAAAAAAAAAAAAAAAAAAAAAAAAAAAAAAAAAAAAAAAAAAAAJ/f38AAAAAA8zMzADAwP8Af39/AAAAAAAAAAAAAAAAAAAAAAAAAAAAIQAAABgAAAAUAAAAwRoAAPoUAAD6NgAAtCUAABAAAAAmAAAACAAAAD2wAAAAAAAA"/>
+                <pr:smNativeData xmlns:pr="smNativeData" xmlns="smNativeData" val="SMDATA_15_9kV5ZhMAAAAlAAAAZAAAAA0AAAAAkAAAAJAAAACQAAAAkAAAAAAAAAAAAAAAAAAAAAEAAABQAAAAAAAAAAAA4D8AAAAAAADgPwAAAAAAAOA/AAAAAAAA4D8AAAAAAADgPwAAAAAAAOA/AAAAAAAA4D8AAAAAAADgPwAAAAAAAOA/AAAAAAAA4D8CAAAAjAAAAAAAAAAAAAAAQoX0DP///wgAAAAAAAAAAAAAAAAAAAAAAAAAAAAAAAAAAAAAZAAAAAEAAABAAAAAAAAAAAAAAAAAAAAAAAAAAAAAAAAAAAAAAAAAAAAAAAAAAAAAAAAAAAAAAAAAAAAAAAAAAAAAAAAAAAAAAAAAAAAAAAAAAAAAAAAAAAAAAAAAAAAAFAAAADwAAAAAAAAAAAAAAAAAAAkUAAAAAQAAABQAAAAUAAAAFAAAAAEAAAAAAAAAZAAAAGQAAAAAAAAAZAAAAGQAAAAVAAAAYAAAAAAAAAAAAAAADwAAACADAAAAAAAAAAAAAAEAAACgMgAAVgcAAKr4//8BAAAAf39/AAEAAABkAAAAAAAAABQAAABAHwAAAAAAACYAAAAAAAAAwOD//wAAAAAmAAAAZAAAABYAAABMAAAAAAAAAAAAAAAEAAAAAAAAAAEAAABZWVkKAAAAACgAAAAoAAAAZAAAAGQAAAAAAAAAzMzMAAAAAABQAAAAUAAAAGQAAABkAAAAAAAAABcAAAAUAAAAAAAAAAAAAAD/fwAA/38AAAAAAAAJAAAABAAAAAAAAAAeAAAAaAAAAAAAAAAAAAAAAAAAAAAAAAAAAAAAECcAABAnAAAAAAAAAAAAAAAAAAAAAAAAAAAAAAAAAAAAAAAAAAAAABQAAAAAAAAAwMD/AAAAAABkAAAAMgAAAAAAAABkAAAAAAAAAH9/fwAKAAAAIgAAABgAAAAAAAAAAAAAAAAAAAAAAAAAAAAAAAAAAAAkAAAAJAAAAAAAAAAHAAAAAAAAAAAAAAAAAAAAAAAAAAAAAAAAAAAAf39/ACUAAABYAAAAAAAAAAAAAAAAAAAAAAAAAAAAAAAAAAAAAAAAAAAAAAAAAAAAAAAAAAAAAAA/AAAAAAAAAKCGAQAAAAAAAAAAAAAAAAAMAAAAAQAAAAAAAAAAAAAAAAAAAB8AAABUAAAAAAAABQAAAAEAAAAAAAAAAAAAAAAAAAAAAAAAAAAAAAAAAAAAAAAAAAAAAAJ/f38AAAAAA8zMzADAwP8Af39/AAAAAAAAAAAAAAAAAAAAAAAAAAAAIQAAABgAAAAUAAAAwRoAAPoUAAD6NgAAtCUAABAAAAAmAAAACAAAAD2wAAAAAAAA"/>
               </a:ext>
             </a:extLst>
           </p:cNvSpPr>
@@ -6988,7 +6988,7 @@
           <p:cNvSpPr>
             <a:extLst>
               <a:ext uri="smNativeData">
-                <pr:smNativeData xmlns:pr="smNativeData" xmlns="smNativeData" val="SMDATA_15_FUV5ZhMAAAAlAAAAZAAAAA0AAAAAkAAAAJAAAACQAAAAkAAAAAAAAAABAAAAAAAAAAEAAABQAAAAAAAAAAAA4D8AAAAAAADgPwAAAAAAAOA/AAAAAAAA4D8AAAAAAADgPwAAAAAAAOA/AAAAAAAA4D8AAAAAAADgPwAAAAAAAOA/AAAAAAAA4D8CAAAAjAAAAAEAAAAAAAAA8/PzAP///wgAAAAAAAAAAAAAAAAAAAAAAAAAAAAAAAAAAAAAeAAAAAEAAABAAAAAAAAAAAAAAABaAAAAAAAAAAAAAAAAAAAAAAAAAAAAAAAAAAAAAAAAAAAAAAAAAAAAAAAAAAAAAAAAAAAAAAAAAAAAAAAAAAAAAAAAAAAAAAAAAAAAFAAAADwAAAAAAAAAAAAAAAAAAAkUAAAAAQAAABQAAAAUAAAAFAAAAAEAAAAAAAAAZAAAAGQAAAAAAAAAZAAAAGQAAAAVAAAAYAAAAAAAAAAAAAAADwAAACADAAAAAAAAAAAAAAEAAACgMgAAVgcAAKr4//8BAAAAf39/AAEAAABkAAAAAAAAABQAAABAHwAAAAAAACYAAAAAAAAAwOD//wAAAAAmAAAAZAAAABYAAABMAAAAAAAAAAAAAAAEAAAAAAAAAAEAAABZWVkKAAAAACgAAAAoAAAAZAAAAGQAAAAAAAAAzMzMAAAAAABQAAAAUAAAAGQAAABkAAAAAAAAABcAAAAUAAAAAAAAAAAAAAD/fwAA/38AAAAAAAAJAAAABAAAAAAAAAAeAAAAaAAAAAAAAAAAAAAAAAAAAAAAAAAAAAAAECcAABAnAAAAAAAAAAAAAAAAAAAAAAAAAAAAAAAAAAAAAAAAAAAAABQAAAAAAAAAwMD/AAAAAABkAAAAMgAAAAAAAABkAAAAAAAAAH9/fwAKAAAAIgAAABgAAAAAAAAAAAAAAAAAAAAAAAAAAAAAAAAAAAAkAAAAJAAAAAAAAAAHAAAAAAAAAAAAAAAAAAAAAAAAAAAAAAAAAAAAf39/ACUAAABYAAAAAAAAAAAAAAAAAAAAAAAAAAAAAAAAAAAAAAAAAAAAAAAAAAAAAAAAAAAAAAA/AAAAAAAAAKCGAQAAAAAAAAAAAAAAAAAMAAAAAQAAAAAAAAAAAAAAAAAAAB8AAABUAAAA8/PzAAAAAAEAAAAAAAAAAAAAAAAAAAAAAAAAAAAAAAAAAAAAAAAAAAAAAAJ/f38AAAAAA8zMzADAwP8Af39/AAAAAAAAAAAAAAAAAAAAAAAAAAAAIQAAABgAAAAUAAAAIBwAAAAAAABAOAAAMCoAABAAAAAmAAAACAAAAP//////////"/>
+                <pr:smNativeData xmlns:pr="smNativeData" xmlns="smNativeData" val="SMDATA_15_9kV5ZhMAAAAlAAAAZAAAAA0AAAAAkAAAAJAAAACQAAAAkAAAAAAAAAABAAAAAAAAAAEAAABQAAAAAAAAAAAA4D8AAAAAAADgPwAAAAAAAOA/AAAAAAAA4D8AAAAAAADgPwAAAAAAAOA/AAAAAAAA4D8AAAAAAADgPwAAAAAAAOA/AAAAAAAA4D8CAAAAjAAAAAEAAAAAAAAA8/PzAP///wgAAAAAAAAAAAAAAAAAAAAAAAAAAAAAAAAAAAAAeAAAAAEAAABAAAAAAAAAAAAAAABaAAAAAAAAAAAAAAAAAAAAAAAAAAAAAAAAAAAAAAAAAAAAAAAAAAAAAAAAAAAAAAAAAAAAAAAAAAAAAAAAAAAAAAAAAAAAAAAAAAAAFAAAADwAAAAAAAAAAAAAAAAAAAkUAAAAAQAAABQAAAAUAAAAFAAAAAEAAAAAAAAAZAAAAGQAAAAAAAAAZAAAAGQAAAAVAAAAYAAAAAAAAAAAAAAADwAAACADAAAAAAAAAAAAAAEAAACgMgAAVgcAAKr4//8BAAAAf39/AAEAAABkAAAAAAAAABQAAABAHwAAAAAAACYAAAAAAAAAwOD//wAAAAAmAAAAZAAAABYAAABMAAAAAAAAAAAAAAAEAAAAAAAAAAEAAABZWVkKAAAAACgAAAAoAAAAZAAAAGQAAAAAAAAAzMzMAAAAAABQAAAAUAAAAGQAAABkAAAAAAAAABcAAAAUAAAAAAAAAAAAAAD/fwAA/38AAAAAAAAJAAAABAAAAAAAAAAeAAAAaAAAAAAAAAAAAAAAAAAAAAAAAAAAAAAAECcAABAnAAAAAAAAAAAAAAAAAAAAAAAAAAAAAAAAAAAAAAAAAAAAABQAAAAAAAAAwMD/AAAAAABkAAAAMgAAAAAAAABkAAAAAAAAAH9/fwAKAAAAIgAAABgAAAAAAAAAAAAAAAAAAAAAAAAAAAAAAAAAAAAkAAAAJAAAAAAAAAAHAAAAAAAAAAAAAAAAAAAAAAAAAAAAAAAAAAAAf39/ACUAAABYAAAAAAAAAAAAAAAAAAAAAAAAAAAAAAAAAAAAAAAAAAAAAAAAAAAAAAAAAAAAAAA/AAAAAAAAAKCGAQAAAAAAAAAAAAAAAAAMAAAAAQAAAAAAAAAAAAAAAAAAAB8AAABUAAAA8/PzAAAAAAEAAAAAAAAAAAAAAAAAAAAAAAAAAAAAAAAAAAAAAAAAAAAAAAJ/f38AAAAAA8zMzADAwP8Af39/AAAAAAAAAAAAAAAAAAAAAAAAAAAAIQAAABgAAAAUAAAAIBwAAAAAAABAOAAAMCoAABAAAAAmAAAACAAAAP//////////"/>
               </a:ext>
             </a:extLst>
           </p:cNvSpPr>
@@ -7033,7 +7033,7 @@
             <a:spLocks noGrp="1" noChangeArrowheads="1"/>
             <a:extLst>
               <a:ext uri="smNativeData">
-                <pr:smNativeData xmlns:pr="smNativeData" xmlns="smNativeData" val="SMDATA_15_FUV5ZhMAAAAlAAAAZAAAAA0AAAAAkAAAAJAAAACQAAAAkAAAAAAAAAACAAAAAAAAAAEAAABQAAAAAAAAAAAA4D8AAAAAAADgPwAAAAAAAOA/AAAAAAAA4D8AAAAAAADgPwAAAAAAAOA/AAAAAAAA4D8AAAAAAADgPwAAAAAAAOA/AAAAAAAA4D8CAAAAjAAAAAAAAAAAAAAAQoX0DP///wgAAAAAAAAAAAAAAAAAAAAAAAAAAAAAAAAAAAAAZAAAAAEAAABAAAAAAAAAAAAAAAAAAAAAAAAAAAAAAAAAAAAAAAAAAAAAAAAAAAAAAAAAAAAAAAAAAAAAAAAAAAAAAAAAAAAAAAAAAAAAAAAAAAAAAAAAAAAAAAAAAAAAFAAAADwAAAAAAAAAAAAAAAAAAAkUAAAAAQAAABQAAAAUAAAAFAAAAAEAAAAAAAAAZAAAAGQAAAAAAAAAZAAAAGQAAAAVAAAAYAAAAAAAAAAAAAAADwAAACADAAAAAAAAAAAAAAEAAACgMgAAVgcAAKr4//8BAAAAf39/AAEAAABkAAAAAAAAABQAAABAHwAAAAAAACYAAAAAAAAAwOD//wAAAAAmAAAAZAAAABYAAABMAAAAAAAAAAAAAAAEAAAAAAAAAAEAAABZWVkKAAAAACgAAAAoAAAAZAAAAGQAAAAAAAAAzMzMAAAAAABQAAAAUAAAAGQAAABkAAAAAAAAABcAAAAUAAAAAAAAAAAAAAD/fwAA/38AAAAAAAAJAAAABAAAAAAAAAAeAAAAaAAAAAAAAAAAAAAAAAAAAAAAAAAAAAAAECcAABAnAAAAAAAAAAAAAAAAAAAAAAAAAAAAAAAAAAAAAAAAAAAAABQAAAAAAAAAwMD/AAAAAABkAAAAMgAAAAAAAABkAAAAAAAAAH9/fwAKAAAAIgAAABgAAAAAAAAAAAAAAAAAAAAAAAAAAAAAAAAAAAAkAAAAJAAAAAAAAAAHAAAAAAAAAAAAAAAAAAAAAAAAAAAAAAAAAAAAf39/ACUAAABYAAAAAAAAAAAAAAAAAAAAAAAAAAAAAAAAAAAAAAAAAAAAAAAAAAAAAAAAAAAAAAA/AAAAAAAAAKCGAQAAAAAAAAAAAAAAAAAMAAAAAQAAAAAAAAAAAAAAAAAAAB8AAABUAAAAAAAABQAAAAEAAAAAAAAAAAAAAAAAAAAAAAAAAAAAAAAAAAAAAAAAAAAAAAJ/f38AAAAAA8zMzADAwP8Af39/AAAAAAAAAAAAAAAAAAAAAAAAAAAAIQAAABgAAAAUAAAAvwMAAAQKAACiHAAALBYAABAAAAAmAAAACAAAAL2wAAAAAAAA"/>
+                <pr:smNativeData xmlns:pr="smNativeData" xmlns="smNativeData" val="SMDATA_15_9kV5ZhMAAAAlAAAAZAAAAA0AAAAAkAAAAJAAAACQAAAAkAAAAAAAAAACAAAAAAAAAAEAAABQAAAAAAAAAAAA4D8AAAAAAADgPwAAAAAAAOA/AAAAAAAA4D8AAAAAAADgPwAAAAAAAOA/AAAAAAAA4D8AAAAAAADgPwAAAAAAAOA/AAAAAAAA4D8CAAAAjAAAAAAAAAAAAAAAQoX0DP///wgAAAAAAAAAAAAAAAAAAAAAAAAAAAAAAAAAAAAAZAAAAAEAAABAAAAAAAAAAAAAAAAAAAAAAAAAAAAAAAAAAAAAAAAAAAAAAAAAAAAAAAAAAAAAAAAAAAAAAAAAAAAAAAAAAAAAAAAAAAAAAAAAAAAAAAAAAAAAAAAAAAAAFAAAADwAAAAAAAAAAAAAAAAAAAkUAAAAAQAAABQAAAAUAAAAFAAAAAEAAAAAAAAAZAAAAGQAAAAAAAAAZAAAAGQAAAAVAAAAYAAAAAAAAAAAAAAADwAAACADAAAAAAAAAAAAAAEAAACgMgAAVgcAAKr4//8BAAAAf39/AAEAAABkAAAAAAAAABQAAABAHwAAAAAAACYAAAAAAAAAwOD//wAAAAAmAAAAZAAAABYAAABMAAAAAAAAAAAAAAAEAAAAAAAAAAEAAABZWVkKAAAAACgAAAAoAAAAZAAAAGQAAAAAAAAAzMzMAAAAAABQAAAAUAAAAGQAAABkAAAAAAAAABcAAAAUAAAAAAAAAAAAAAD/fwAA/38AAAAAAAAJAAAABAAAAAAAAAAeAAAAaAAAAAAAAAAAAAAAAAAAAAAAAAAAAAAAECcAABAnAAAAAAAAAAAAAAAAAAAAAAAAAAAAAAAAAAAAAAAAAAAAABQAAAAAAAAAwMD/AAAAAABkAAAAMgAAAAAAAABkAAAAAAAAAH9/fwAKAAAAIgAAABgAAAAAAAAAAAAAAAAAAAAAAAAAAAAAAAAAAAAkAAAAJAAAAAAAAAAHAAAAAAAAAAAAAAAAAAAAAAAAAAAAAAAAAAAAf39/ACUAAABYAAAAAAAAAAAAAAAAAAAAAAAAAAAAAAAAAAAAAAAAAAAAAAAAAAAAAAAAAAAAAAA/AAAAAAAAAKCGAQAAAAAAAAAAAAAAAAAMAAAAAQAAAAAAAAAAAAAAAAAAAB8AAABUAAAAAAAABQAAAAEAAAAAAAAAAAAAAAAAAAAAAAAAAAAAAAAAAAAAAAAAAAAAAAJ/f38AAAAAA8zMzADAwP8Af39/AAAAAAAAAAAAAAAAAAAAAAAAAAAAIQAAABgAAAAUAAAAvwMAAAQKAACiHAAALBYAABAAAAAmAAAACAAAAL2wAAAAAAAA"/>
               </a:ext>
             </a:extLst>
           </p:cNvSpPr>
@@ -7157,7 +7157,7 @@
             <a:spLocks noGrp="1" noChangeArrowheads="1"/>
             <a:extLst>
               <a:ext uri="smNativeData">
-                <pr:smNativeData xmlns:pr="smNativeData" xmlns="smNativeData" val="SMDATA_15_FUV5ZhMAAAAlAAAAZAAAAA0AAAAAkAAAAJAAAACQAAAAkAAAAAAAAAAAAAAAAAAAAAEAAABQAAAAAAAAAAAA4D8AAAAAAADgPwAAAAAAAOA/AAAAAAAA4D8AAAAAAADgPwAAAAAAAOA/AAAAAAAA4D8AAAAAAADgPwAAAAAAAOA/AAAAAAAA4D8CAAAAjAAAAAAAAAAAAAAAQoX0DP///wgAAAAAAAAAAAAAAAAAAAAAAAAAAAAAAAAAAAAAZAAAAAEAAABAAAAAAAAAAAAAAAAAAAAAAAAAAAAAAAAAAAAAAAAAAAAAAAAAAAAAAAAAAAAAAAAAAAAAAAAAAAAAAAAAAAAAAAAAAAAAAAAAAAAAAAAAAAAAAAAAAAAAFAAAADwAAAAAAAAAAAAAAAAAAAkUAAAAAQAAABQAAAAUAAAAFAAAAAEAAAAAAAAAZAAAAGQAAAAAAAAAZAAAAGQAAAAVAAAAYAAAAAAAAAAAAAAADwAAACADAAAAAAAAAAAAAAEAAACgMgAAVgcAAKr4//8BAAAAf39/AAEAAABkAAAAAAAAABQAAABAHwAAAAAAACYAAAAAAAAAwOD//wAAAAAmAAAAZAAAABYAAABMAAAAAAAAAAAAAAAEAAAAAAAAAAEAAABZWVkKAAAAACgAAAAoAAAAZAAAAGQAAAAAAAAAzMzMAAAAAABQAAAAUAAAAGQAAABkAAAAAAAAABcAAAAUAAAAAAAAAAAAAAD/fwAA/38AAAAAAAAJAAAABAAAAAAAAAAeAAAAaAAAAAAAAAAAAAAAAAAAAAAAAAAAAAAAECcAABAnAAAAAAAAAAAAAAAAAAAAAAAAAAAAAAAAAAAAAAAAAAAAABQAAAAAAAAAwMD/AAAAAABkAAAAMgAAAAAAAABkAAAAAAAAAH9/fwAKAAAAIgAAABgAAAAAAAAAAAAAAAAAAAAAAAAAAAAAAAAAAAAkAAAAJAAAAAAAAAAHAAAAAAAAAAAAAAAAAAAAAAAAAAAAAAAAAAAAf39/ACUAAABYAAAAAAAAAAAAAAAAAAAAAAAAAAAAAAAAAAAAAAAAAAAAAAAAAAAAAAAAAAAAAAA/AAAAAAAAAKCGAQAAAAAAAAAAAAAAAAAMAAAAAQAAAAAAAAAAAAAAAAAAAB8AAABUAAAAAAAABQAAAAEAAAAAAAAAAAAAAAAAAAAAAAAAAAAAAAAAAAAAAAAAAAAAAAJ/f38AAAAAA8zMzADAwP8Af39/AAAAAAAAAAAAAAAAAAAAAAAAAAAAIQAAABgAAAAUAAAAvwMAAOsXAACiHAAADSIAABAAAAAmAAAACAAAAD2wAAAAAAAA"/>
+                <pr:smNativeData xmlns:pr="smNativeData" xmlns="smNativeData" val="SMDATA_15_9kV5ZhMAAAAlAAAAZAAAAA0AAAAAkAAAAJAAAACQAAAAkAAAAAAAAAAAAAAAAAAAAAEAAABQAAAAAAAAAAAA4D8AAAAAAADgPwAAAAAAAOA/AAAAAAAA4D8AAAAAAADgPwAAAAAAAOA/AAAAAAAA4D8AAAAAAADgPwAAAAAAAOA/AAAAAAAA4D8CAAAAjAAAAAAAAAAAAAAAQoX0DP///wgAAAAAAAAAAAAAAAAAAAAAAAAAAAAAAAAAAAAAZAAAAAEAAABAAAAAAAAAAAAAAAAAAAAAAAAAAAAAAAAAAAAAAAAAAAAAAAAAAAAAAAAAAAAAAAAAAAAAAAAAAAAAAAAAAAAAAAAAAAAAAAAAAAAAAAAAAAAAAAAAAAAAFAAAADwAAAAAAAAAAAAAAAAAAAkUAAAAAQAAABQAAAAUAAAAFAAAAAEAAAAAAAAAZAAAAGQAAAAAAAAAZAAAAGQAAAAVAAAAYAAAAAAAAAAAAAAADwAAACADAAAAAAAAAAAAAAEAAACgMgAAVgcAAKr4//8BAAAAf39/AAEAAABkAAAAAAAAABQAAABAHwAAAAAAACYAAAAAAAAAwOD//wAAAAAmAAAAZAAAABYAAABMAAAAAAAAAAAAAAAEAAAAAAAAAAEAAABZWVkKAAAAACgAAAAoAAAAZAAAAGQAAAAAAAAAzMzMAAAAAABQAAAAUAAAAGQAAABkAAAAAAAAABcAAAAUAAAAAAAAAAAAAAD/fwAA/38AAAAAAAAJAAAABAAAAAAAAAAeAAAAaAAAAAAAAAAAAAAAAAAAAAAAAAAAAAAAECcAABAnAAAAAAAAAAAAAAAAAAAAAAAAAAAAAAAAAAAAAAAAAAAAABQAAAAAAAAAwMD/AAAAAABkAAAAMgAAAAAAAABkAAAAAAAAAH9/fwAKAAAAIgAAABgAAAAAAAAAAAAAAAAAAAAAAAAAAAAAAAAAAAAkAAAAJAAAAAAAAAAHAAAAAAAAAAAAAAAAAAAAAAAAAAAAAAAAAAAAf39/ACUAAABYAAAAAAAAAAAAAAAAAAAAAAAAAAAAAAAAAAAAAAAAAAAAAAAAAAAAAAAAAAAAAAA/AAAAAAAAAKCGAQAAAAAAAAAAAAAAAAAMAAAAAQAAAAAAAAAAAAAAAAAAAB8AAABUAAAAAAAABQAAAAEAAAAAAAAAAAAAAAAAAAAAAAAAAAAAAAAAAAAAAAAAAAAAAAJ/f38AAAAAA8zMzADAwP8Af39/AAAAAAAAAAAAAAAAAAAAAAAAAAAAIQAAABgAAAAUAAAAvwMAAOsXAACiHAAADSIAABAAAAAmAAAACAAAAD2wAAAAAAAA"/>
               </a:ext>
             </a:extLst>
           </p:cNvSpPr>
@@ -7308,7 +7308,7 @@
             <a:spLocks noGrp="1" noChangeArrowheads="1"/>
             <a:extLst>
               <a:ext uri="smNativeData">
-                <pr:smNativeData xmlns:pr="smNativeData" xmlns="smNativeData" val="SMDATA_15_FUV5ZhMAAAAlAAAAZAAAAA0AAAAAkAAAAJAAAACQAAAAkAAAAAAAAAABAAAAAAAAAAEAAABQAAAAAAAAAAAA4D8AAAAAAADgPwAAAAAAAOA/AAAAAAAA4D8AAAAAAADgPwAAAAAAAOA/AAAAAAAA4D8AAAAAAADgPwAAAAAAAOA/AAAAAAAA4D8CAAAAjAAAAAAAAAAAAAAAQoX0DP///wgAAAAAAAAAAAAAAAAAAAAAAAAAAAAAAAAAAAAAZAAAAAEAAABAAAAAAAAAAAAAAAAAAAAAAAAAAAAAAAAAAAAAAAAAAAAAAAAAAAAAAAAAAAAAAAAAAAAAAAAAAAAAAAAAAAAAAAAAAAAAAAAAAAAAAAAAAAAAAAAAAAAAFAAAADwAAAAAAAAAAAAAAAAAAAkUAAAAAQAAABQAAAAUAAAAFAAAAAEAAAAAAAAAZAAAAGQAAAAAAAAAZAAAAGQAAAAVAAAAYAAAAAAAAAAAAAAADwAAACADAAAAAAAAAAAAAAEAAACgMgAAVgcAAKr4//8BAAAAf39/AAEAAABkAAAAAAAAABQAAABAHwAAAAAAACYAAAAAAAAAwOD//wAAAAAmAAAAZAAAABYAAABMAAAAAAAAAAAAAAAEAAAAAAAAAAEAAABZWVkKAAAAACgAAAAoAAAAZAAAAGQAAAAAAAAAzMzMAAAAAABQAAAAUAAAAGQAAABkAAAAAAAAABcAAAAUAAAAAAAAAAAAAAD/fwAA/38AAAAAAAAJAAAABAAAAAAAAMAeAAAAaAAAAAAAAAAAAAAAAAAAAAAAAAAAAAAAECcAABAnAAAAAAAAAAAAAAAAAAAAAAAAAAAAAAAAAAAAAAAAAAAAABQAAAAAAAAAwMD/AAAAAABkAAAAMgAAAAAAAABkAAAAAAAAAH9/fwAKAAAAIgAAABgAAAAAAAAAAAAAAAAAAAAAAAAAAAAAAAAAAAAkAAAAJAAAAAAAAAAHAAAAAAAAAAAAAAAAAAAAAAAAAAAAAAAAAAAAf39/ACUAAABYAAAAAAAAAAAAAAAAAAAAAAAAAAAAAAAAAAAAAAAAAAAAAAAAAAAAAAAAAAAAAAA/AAAAAAAAAKCGAQAAAAAAAAAAAAAAAAAMAAAAAQAAAAAAAAAAAAAAAAAAAB8AAABUAAAAAAAABQAAAAEAAAAAAAAAAAAAAAAAAAAAAAAAAAAAAAAAAAAAAAAAAAAAAAJ/f38AAAAAA8zMzADAwP8Af39/AAAAAAAAAAAAAAAAAAAAAAAAAAAAIQAAABgAAAAUAAAAYx4AAPAFAAD9NQAAPyQAABAAAAAmAAAACAAAAL2wAAAAAAAA"/>
+                <pr:smNativeData xmlns:pr="smNativeData" xmlns="smNativeData" val="SMDATA_15_9kV5ZhMAAAAlAAAAZAAAAA0AAAAAkAAAAJAAAACQAAAAkAAAAAAAAAABAAAAAAAAAAEAAABQAAAAAAAAAAAA4D8AAAAAAADgPwAAAAAAAOA/AAAAAAAA4D8AAAAAAADgPwAAAAAAAOA/AAAAAAAA4D8AAAAAAADgPwAAAAAAAOA/AAAAAAAA4D8CAAAAjAAAAAAAAAAAAAAAQoX0DP///wgAAAAAAAAAAAAAAAAAAAAAAAAAAAAAAAAAAAAAZAAAAAEAAABAAAAAAAAAAAAAAAAAAAAAAAAAAAAAAAAAAAAAAAAAAAAAAAAAAAAAAAAAAAAAAAAAAAAAAAAAAAAAAAAAAAAAAAAAAAAAAAAAAAAAAAAAAAAAAAAAAAAAFAAAADwAAAAAAAAAAAAAAAAAAAkUAAAAAQAAABQAAAAUAAAAFAAAAAEAAAAAAAAAZAAAAGQAAAAAAAAAZAAAAGQAAAAVAAAAYAAAAAAAAAAAAAAADwAAACADAAAAAAAAAAAAAAEAAACgMgAAVgcAAKr4//8BAAAAf39/AAEAAABkAAAAAAAAABQAAABAHwAAAAAAACYAAAAAAAAAwOD//wAAAAAmAAAAZAAAABYAAABMAAAAAAAAAAAAAAAEAAAAAAAAAAEAAABZWVkKAAAAACgAAAAoAAAAZAAAAGQAAAAAAAAAzMzMAAAAAABQAAAAUAAAAGQAAABkAAAAAAAAABcAAAAUAAAAAAAAAAAAAAD/fwAA/38AAAAAAAAJAAAABAAAAAAAAMAeAAAAaAAAAAAAAAAAAAAAAAAAAAAAAAAAAAAAECcAABAnAAAAAAAAAAAAAAAAAAAAAAAAAAAAAAAAAAAAAAAAAAAAABQAAAAAAAAAwMD/AAAAAABkAAAAMgAAAAAAAABkAAAAAAAAAH9/fwAKAAAAIgAAABgAAAAAAAAAAAAAAAAAAAAAAAAAAAAAAAAAAAAkAAAAJAAAAAAAAAAHAAAAAAAAAAAAAAAAAAAAAAAAAAAAAAAAAAAAf39/ACUAAABYAAAAAAAAAAAAAAAAAAAAAAAAAAAAAAAAAAAAAAAAAAAAAAAAAAAAAAAAAAAAAAA/AAAAAAAAAKCGAQAAAAAAAAAAAAAAAAAMAAAAAQAAAAAAAAAAAAAAAAAAAB8AAABUAAAAAAAABQAAAAEAAAAAAAAAAAAAAAAAAAAAAAAAAAAAAAAAAAAAAAAAAAAAAAJ/f38AAAAAA8zMzADAwP8Af39/AAAAAAAAAAAAAAAAAAAAAAAAAAAAIQAAABgAAAAUAAAAYx4AAPAFAAD9NQAAPyQAABAAAAAmAAAACAAAAL2wAAAAAAAA"/>
               </a:ext>
             </a:extLst>
           </p:cNvSpPr>
@@ -7432,7 +7432,7 @@
             <a:spLocks noGrp="1" noChangeArrowheads="1"/>
             <a:extLst>
               <a:ext uri="smNativeData">
-                <pr:smNativeData xmlns:pr="smNativeData" xmlns="smNativeData" val="SMDATA_15_FUV5ZhMAAAAlAAAAZAAAAA0AAAAAkAAAAJAAAACQAAAAkAAAAAAAAAABAAAAAAAAAAEAAABQAAAAAAAAAAAA4D8AAAAAAADgPwAAAAAAAOA/AAAAAAAA4D8AAAAAAADgPwAAAAAAAOA/AAAAAAAA4D8AAAAAAADgPwAAAAAAAOA/AAAAAAAA4D8CAAAAjAAAAAAAAAAAAAAAQoX0DP///wgAAAAAAAAAAAAAAAAAAAAAAAAAAAAAAAAAAAAAZAAAAAEAAABAAAAAAAAAAAAAAAAAAAAAAAAAAAAAAAAAAAAAAAAAAAAAAAAAAAAAAAAAAAAAAAAAAAAAAAAAAAAAAAAAAAAAAAAAAAAAAAAAAAAAAAAAAAAAAAAAAAAAFAAAADwAAAAAAAAAAAAAAAAAAAkUAAAAAQAAABQAAAAUAAAAFAAAAAEAAAAAAAAAZAAAAGQAAAAAAAAAZAAAAGQAAAAVAAAAYAAAAAAAAAAAAAAADwAAACADAAAAAAAAAAAAAAEAAACgMgAAVgcAAKr4//8BAAAAf39/AAEAAABkAAAAAAAAABQAAABAHwAAAAAAACYAAAAAAAAAwOD//wAAAAAmAAAAZAAAABYAAABMAAAAAAAAAAAAAAAEAAAAAAAAAAEAAABZWVkKAAAAACgAAAAoAAAAZAAAAGQAAAAAAAAAzMzMAAAAAABQAAAAUAAAAGQAAABkAAAAAAAAABcAAAAUAAAAAAAAAAAAAAD/fwAA/38AAAAAAAAJAAAABAAAAAAAAAAeAAAAaAAAAAAAAAAAAAAAAAAAAAAAAAAAAAAAECcAABAnAAAAAAAAAAAAAAAAAAAAAAAAAAAAAAAAAAAAAAAAAAAAABQAAAAAAAAAwMD/AAAAAABkAAAAMgAAAAAAAABkAAAAAAAAAH9/fwAKAAAAIgAAABgAAAAAAAAAAAAAAAAAAAAAAAAAAAAAAAAAAAAkAAAAJAAAAAAAAAAHAAAAAAAAAAAAAAAAAAAAAAAAAAAAAAAAAAAAf39/ACUAAABYAAAAAAAAAAAAAAAAAAAAAAAAAAAAAAAAAAAAAAAAAAAAAAAAAAAAAAAAAAAAAAA/AAAAAAAAAKCGAQAAAAAAAAAAAAAAAAAMAAAAAQAAAAAAAAAAAAAAAAAAAB8AAABUAAAAAAAABQAAAAEAAAAAAAAAAAAAAAAAAAAAAAAAAAAAAAAAAAAAAAAAAAAAAAJ/f38AAAAAA8zMzADAwP8Af39/AAAAAAAAAAAAAAAAAAAAAAAAAAAAIQAAABgAAAAUAAAAHjQAAEAmAAB/NwAAeikAABAAAAAmAAAACAAAADywAAAAAAAA"/>
+                <pr:smNativeData xmlns:pr="smNativeData" xmlns="smNativeData" val="SMDATA_15_9kV5ZhMAAAAlAAAAZAAAAA0AAAAAkAAAAJAAAACQAAAAkAAAAAAAAAABAAAAAAAAAAEAAABQAAAAAAAAAAAA4D8AAAAAAADgPwAAAAAAAOA/AAAAAAAA4D8AAAAAAADgPwAAAAAAAOA/AAAAAAAA4D8AAAAAAADgPwAAAAAAAOA/AAAAAAAA4D8CAAAAjAAAAAAAAAAAAAAAQoX0DP///wgAAAAAAAAAAAAAAAAAAAAAAAAAAAAAAAAAAAAAZAAAAAEAAABAAAAAAAAAAAAAAAAAAAAAAAAAAAAAAAAAAAAAAAAAAAAAAAAAAAAAAAAAAAAAAAAAAAAAAAAAAAAAAAAAAAAAAAAAAAAAAAAAAAAAAAAAAAAAAAAAAAAAFAAAADwAAAAAAAAAAAAAAAAAAAkUAAAAAQAAABQAAAAUAAAAFAAAAAEAAAAAAAAAZAAAAGQAAAAAAAAAZAAAAGQAAAAVAAAAYAAAAAAAAAAAAAAADwAAACADAAAAAAAAAAAAAAEAAACgMgAAVgcAAKr4//8BAAAAf39/AAEAAABkAAAAAAAAABQAAABAHwAAAAAAACYAAAAAAAAAwOD//wAAAAAmAAAAZAAAABYAAABMAAAAAAAAAAAAAAAEAAAAAAAAAAEAAABZWVkKAAAAACgAAAAoAAAAZAAAAGQAAAAAAAAAzMzMAAAAAABQAAAAUAAAAGQAAABkAAAAAAAAABcAAAAUAAAAAAAAAAAAAAD/fwAA/38AAAAAAAAJAAAABAAAAAAAAAAeAAAAaAAAAAAAAAAAAAAAAAAAAAAAAAAAAAAAECcAABAnAAAAAAAAAAAAAAAAAAAAAAAAAAAAAAAAAAAAAAAAAAAAABQAAAAAAAAAwMD/AAAAAABkAAAAMgAAAAAAAABkAAAAAAAAAH9/fwAKAAAAIgAAABgAAAAAAAAAAAAAAAAAAAAAAAAAAAAAAAAAAAAkAAAAJAAAAAAAAAAHAAAAAAAAAAAAAAAAAAAAAAAAAAAAAAAAAAAAf39/ACUAAABYAAAAAAAAAAAAAAAAAAAAAAAAAAAAAAAAAAAAAAAAAAAAAAAAAAAAAAAAAAAAAAA/AAAAAAAAAKCGAQAAAAAAAAAAAAAAAAAMAAAAAQAAAAAAAAAAAAAAAAAAAB8AAABUAAAAAAAABQAAAAEAAAAAAAAAAAAAAAAAAAAAAAAAAAAAAAAAAAAAAAAAAAAAAAJ/f38AAAAAA8zMzADAwP8Af39/AAAAAAAAAAAAAAAAAAAAAAAAAAAAIQAAABgAAAAUAAAAHjQAAEAmAAB/NwAAeikAABAAAAAmAAAACAAAADywAAAAAAAA"/>
               </a:ext>
             </a:extLst>
           </p:cNvSpPr>
@@ -7486,7 +7486,7 @@
               </a:spcAft>
               <a:buNone/>
             </a:pPr>
-            <a:fld id="{3FD914B5-FBD2-8CE2-9C61-0DB75A2F6A58}" type="slidenum">
+            <a:fld id="{3FDDD79A-D4D2-8821-9C65-2274992B6A77}" type="slidenum">
               <a:rPr lang="ru-ru" cap="none"/>
               <a:t>‹#›</a:t>
             </a:fld>
@@ -7527,7 +7527,7 @@
             <a:spLocks noGrp="1" noChangeArrowheads="1"/>
             <a:extLst>
               <a:ext uri="smNativeData">
-                <pr:smNativeData xmlns:pr="smNativeData" xmlns="smNativeData" val="SMDATA_15_FUV5ZhMAAAAlAAAAZAAAAA0AAAAAkAAAAJAAAACQAAAAkAAAAAAAAAABAAAAAAAAAAEAAABQAAAAAAAAAAAA4D8AAAAAAADgPwAAAAAAAOA/AAAAAAAA4D8AAAAAAADgPwAAAAAAAOA/AAAAAAAA4D8AAAAAAADgPwAAAAAAAOA/AAAAAAAA4D8CAAAAjAAAAAAAAAAAAAAAQoX0DP///wgAAAAAAAAAAAAAAAAAAAAAAAAAAAAAAAAAAAAAZAAAAAEAAABAAAAAAAAAAAAAAAAAAAAAAAAAAAAAAAAAAAAAAAAAAAAAAAAAAAAAAAAAAAAAAAAAAAAAAAAAAAAAAAAAAAAAAAAAAAAAAAAAAAAAAAAAAAAAAAAAAAAAFAAAADwAAAAAAAAAAAAAAAAAAAkUAAAAAQAAABQAAAAUAAAAFAAAAAEAAAAAAAAAZAAAAGQAAAAAAAAAZAAAAGQAAAAVAAAAYAAAAAAAAAAAAAAADwAAACADAAAAAAAAAAAAAAEAAACgMgAAVgcAAKr4//8BAAAAf39/AAEAAABkAAAAAAAAABQAAABAHwAAAAAAACYAAAAAAAAAwOD//wAAAAAmAAAAZAAAABYAAABMAAAAAAAAAAAAAAAEAAAAAAAAAAEAAABZWVkKAAAAACgAAAAoAAAAZAAAAGQAAAAAAAAAzMzMAAAAAABQAAAAUAAAAGQAAABkAAAAAAAAABcAAAAUAAAAAAAAAAAAAAD/fwAA/38AAAAAAAAJAAAABAAAAAAAAAAeAAAAaAAAAAAAAAAAAAAAAAAAAAAAAAAAAAAAECcAABAnAAAAAAAAAAAAAAAAAAAAAAAAAAAAAAAAAAAAAAAAAAAAABQAAAAAAAAAwMD/AAAAAABkAAAAMgAAAAAAAABkAAAAAAAAAH9/fwAKAAAAIgAAABgAAAAAAAAAAAAAAAAAAAAAAAAAAAAAAAAAAAAkAAAAJAAAAAAAAAAHAAAAAAAAAAAAAAAAAAAAAAAAAAAAAAAAAAAAf39/ACUAAABYAAAAAAAAAAAAAAAAAAAAAAAAAAAAAAAAAAAAAAAAAAAAAAAAAAAAAAAAAAAAAAA/AAAAAAAAAKCGAQAAAAAAAAAAAAAAAAAMAAAAAQAAAAAAAAAAAAAAAAAAAB8AAABUAAAAAAAABQAAAAEAAAAAAAAAAAAAAAAAAAAAAAAAAAAAAAAAAAAAAAAAAAAAAAJ/f38AAAAAA8zMzADAwP8Af39/AAAAAAAAAAAAAAAAAAAAAAAAAAAAIQAAABgAAAAUAAAAHjQAAEAmAAB/NwAAeikAABAAAAAmAAAACAAAADywAAAAAAAA"/>
+                <pr:smNativeData xmlns:pr="smNativeData" xmlns="smNativeData" val="SMDATA_15_9kV5ZhMAAAAlAAAAZAAAAA0AAAAAkAAAAJAAAACQAAAAkAAAAAAAAAABAAAAAAAAAAEAAABQAAAAAAAAAAAA4D8AAAAAAADgPwAAAAAAAOA/AAAAAAAA4D8AAAAAAADgPwAAAAAAAOA/AAAAAAAA4D8AAAAAAADgPwAAAAAAAOA/AAAAAAAA4D8CAAAAjAAAAAAAAAAAAAAAQoX0DP///wgAAAAAAAAAAAAAAAAAAAAAAAAAAAAAAAAAAAAAZAAAAAEAAABAAAAAAAAAAAAAAAAAAAAAAAAAAAAAAAAAAAAAAAAAAAAAAAAAAAAAAAAAAAAAAAAAAAAAAAAAAAAAAAAAAAAAAAAAAAAAAAAAAAAAAAAAAAAAAAAAAAAAFAAAADwAAAAAAAAAAAAAAAAAAAkUAAAAAQAAABQAAAAUAAAAFAAAAAEAAAAAAAAAZAAAAGQAAAAAAAAAZAAAAGQAAAAVAAAAYAAAAAAAAAAAAAAADwAAACADAAAAAAAAAAAAAAEAAACgMgAAVgcAAKr4//8BAAAAf39/AAEAAABkAAAAAAAAABQAAABAHwAAAAAAACYAAAAAAAAAwOD//wAAAAAmAAAAZAAAABYAAABMAAAAAAAAAAAAAAAEAAAAAAAAAAEAAABZWVkKAAAAACgAAAAoAAAAZAAAAGQAAAAAAAAAzMzMAAAAAABQAAAAUAAAAGQAAABkAAAAAAAAABcAAAAUAAAAAAAAAAAAAAD/fwAA/38AAAAAAAAJAAAABAAAAAAAAAAeAAAAaAAAAAAAAAAAAAAAAAAAAAAAAAAAAAAAECcAABAnAAAAAAAAAAAAAAAAAAAAAAAAAAAAAAAAAAAAAAAAAAAAABQAAAAAAAAAwMD/AAAAAABkAAAAMgAAAAAAAABkAAAAAAAAAH9/fwAKAAAAIgAAABgAAAAAAAAAAAAAAAAAAAAAAAAAAAAAAAAAAAAkAAAAJAAAAAAAAAAHAAAAAAAAAAAAAAAAAAAAAAAAAAAAAAAAAAAAf39/ACUAAABYAAAAAAAAAAAAAAAAAAAAAAAAAAAAAAAAAAAAAAAAAAAAAAAAAAAAAAAAAAAAAAA/AAAAAAAAAKCGAQAAAAAAAAAAAAAAAAAMAAAAAQAAAAAAAAAAAAAAAAAAAB8AAABUAAAAAAAABQAAAAEAAAAAAAAAAAAAAAAAAAAAAAAAAAAAAAAAAAAAAAAAAAAAAAJ/f38AAAAAA8zMzADAwP8Af39/AAAAAAAAAAAAAAAAAAAAAAAAAAAAIQAAABgAAAAUAAAAHjQAAEAmAAB/NwAAeikAABAAAAAmAAAACAAAADywAAAAAAAA"/>
               </a:ext>
             </a:extLst>
           </p:cNvSpPr>
@@ -7581,7 +7581,7 @@
               </a:spcAft>
               <a:buNone/>
             </a:pPr>
-            <a:fld id="{3FD93973-3DD2-8CCF-9C61-CB9A772F6A9E}" type="slidenum">
+            <a:fld id="{3FDDC532-7CD2-8833-9C65-8A668B2B6ADF}" type="slidenum">
               <a:rPr lang="ru-ru" cap="none"/>
               <a:t>‹#›</a:t>
             </a:fld>
@@ -7632,7 +7632,7 @@
             <a:spLocks noGrp="1" noChangeArrowheads="1"/>
             <a:extLst>
               <a:ext uri="smNativeData">
-                <pr:smNativeData xmlns:pr="smNativeData" xmlns="smNativeData" val="SMDATA_15_FUV5ZhMAAAAlAAAAZAAAAA0AAAAAkAAAAJAAAACQAAAAkAAAAAAAAAAAAAAAAAAAAAEAAABQAAAAAAAAAAAA4D8AAAAAAADgPwAAAAAAAOA/AAAAAAAA4D8AAAAAAADgPwAAAAAAAOA/AAAAAAAA4D8AAAAAAADgPwAAAAAAAOA/AAAAAAAA4D8CAAAAjAAAAAAAAAAAAAAAQoX0DP///wgAAAAAAAAAAAAAAAAAAAAAAAAAAAAAAAAAAAAAZAAAAAEAAABAAAAAAAAAAAAAAAAAAAAAAAAAAAAAAAAAAAAAAAAAAAAAAAAAAAAAAAAAAAAAAAAAAAAAAAAAAAAAAAAAAAAAAAAAAAAAAAAAAAAAAAAAAAAAAAAAAAAAFAAAADwAAAAAAAAAAAAAAAAAAAkUAAAAAQAAABQAAAAUAAAAFAAAAAEAAAAAAAAAZAAAAGQAAAAAAAAAZAAAAGQAAAAVAAAAYAAAAAAAAAAAAAAADwAAACADAAAAAAAAAAAAAAEAAACgMgAAVgcAAKr4//8BAAAAf39/AAEAAABkAAAAAAAAABQAAABAHwAAAAAAACYAAAAAAAAAwOD//wAAAAAmAAAAZAAAABYAAABMAAAAAAAAAAAAAAAEAAAAAAAAAAEAAABZWVkKAAAAACgAAAAoAAAAZAAAAGQAAAAAAAAAzMzMAAAAAABQAAAAUAAAAGQAAABkAAAAAAAAABcAAAAUAAAAAAAAAAAAAAD/fwAA/38AAAAAAAAJAAAABAAAAGdlODkeAAAAaAAAAAAAAAAAAAAAAAAAAAAAAAAAAAAAECcAABAnAAAAAAAAAAAAAAAAAAAAAAAAAAAAAAAAAAAAAAAAAAAAABQAAAAAAAAAwMD/AAAAAABkAAAAMgAAAAAAAABkAAAAAAAAAH9/fwAKAAAAIgAAABgAAAAAAAAAAAAAAAAAAAAAAAAAAAAAAAAAAAAkAAAAJAAAAAAAAAAHAAAAAAAAAAAAAAAAAAAAAAAAAAAAAAAAAAAAf39/ACUAAABYAAAAAAAAAAAAAAAAAAAAAAAAAAAAAAAAAAAAAAAAAAAAAAAAAAAAAAAAAAAAAAA/AAAAAAAAAKCGAQAAAAAAAAAAAAAAAAAMAAAAAQAAAAAAAAAAAAAAAAAAAB8AAABUAAAAAAAABQAAAAEAAAAAAAAAAAAAAAAAAAAAAAAAAAAAAAAAAAAAAAAAAAAAAAJ/f38AAAAAA8zMzADAwP8Af39/AAAAAAAAAAAAAAAAAAAAAAAAAAAAIQAAABgAAAAUAAAAFAMAALYCAAB/NwAAvwoAABAAAAAmAAAACAAAAL2/AAD/HwAA"/>
+                <pr:smNativeData xmlns:pr="smNativeData" xmlns="smNativeData" val="SMDATA_15_9kV5ZhMAAAAlAAAAZAAAAA0AAAAAkAAAAJAAAACQAAAAkAAAAAAAAAAAAAAAAAAAAAEAAABQAAAAAAAAAAAA4D8AAAAAAADgPwAAAAAAAOA/AAAAAAAA4D8AAAAAAADgPwAAAAAAAOA/AAAAAAAA4D8AAAAAAADgPwAAAAAAAOA/AAAAAAAA4D8CAAAAjAAAAAAAAAAAAAAAQoX0DP///wgAAAAAAAAAAAAAAAAAAAAAAAAAAAAAAAAAAAAAZAAAAAEAAABAAAAAAAAAAAAAAAAAAAAAAAAAAAAAAAAAAAAAAAAAAAAAAAAAAAAAAAAAAAAAAAAAAAAAAAAAAAAAAAAAAAAAAAAAAAAAAAAAAAAAAAAAAAAAAAAAAAAAFAAAADwAAAAAAAAAAAAAAAAAAAkUAAAAAQAAABQAAAAUAAAAFAAAAAEAAAAAAAAAZAAAAGQAAAAAAAAAZAAAAGQAAAAVAAAAYAAAAAAAAAAAAAAADwAAACADAAAAAAAAAAAAAAEAAACgMgAAVgcAAKr4//8BAAAAf39/AAEAAABkAAAAAAAAABQAAABAHwAAAAAAACYAAAAAAAAAwOD//wAAAAAmAAAAZAAAABYAAABMAAAAAAAAAAAAAAAEAAAAAAAAAAEAAABZWVkKAAAAACgAAAAoAAAAZAAAAGQAAAAAAAAAzMzMAAAAAABQAAAAUAAAAGQAAABkAAAAAAAAABcAAAAUAAAAAAAAAAAAAAD/fwAA/38AAAAAAAAJAAAABAAAAGdlODkeAAAAaAAAAAAAAAAAAAAAAAAAAAAAAAAAAAAAECcAABAnAAAAAAAAAAAAAAAAAAAAAAAAAAAAAAAAAAAAAAAAAAAAABQAAAAAAAAAwMD/AAAAAABkAAAAMgAAAAAAAABkAAAAAAAAAH9/fwAKAAAAIgAAABgAAAAAAAAAAAAAAAAAAAAAAAAAAAAAAAAAAAAkAAAAJAAAAAAAAAAHAAAAAAAAAAAAAAAAAAAAAAAAAAAAAAAAAAAAf39/ACUAAABYAAAAAAAAAAAAAAAAAAAAAAAAAAAAAAAAAAAAAAAAAAAAAAAAAAAAAAAAAAAAAAA/AAAAAAAAAKCGAQAAAAAAAAAAAAAAAAAMAAAAAQAAAAAAAAAAAAAAAAAAAB8AAABUAAAAAAAABQAAAAEAAAAAAAAAAAAAAAAAAAAAAAAAAAAAAAAAAAAAAAAAAAAAAAJ/f38AAAAAA8zMzADAwP8Af39/AAAAAAAAAAAAAAAAAAAAAAAAAAAAIQAAABgAAAAUAAAAFAMAALYCAAB/NwAAvwoAABAAAAAmAAAACAAAAL2/AAD/HwAA"/>
               </a:ext>
             </a:extLst>
           </p:cNvSpPr>
@@ -7802,7 +7802,7 @@
             <a:spLocks noGrp="1" noChangeArrowheads="1"/>
             <a:extLst>
               <a:ext uri="smNativeData">
-                <pr:smNativeData xmlns:pr="smNativeData" xmlns="smNativeData" val="SMDATA_15_FUV5ZhMAAAAlAAAAZAAAAA0AAAAAkAAAAJAAAACQAAAAkAAAAAAAAAAAAAAAAAAAAAEAAABQAAAAAAAAAAAA4D8AAAAAAADgPwAAAAAAAOA/AAAAAAAA4D8AAAAAAADgPwAAAAAAAOA/AAAAAAAA4D8AAAAAAADgPwAAAAAAAOA/AAAAAAAA4D8CAAAAjAAAAAAAAAAAAAAAQoX0DP///wgAAAAAAAAAAAAAAAAAAAAAAAAAAAAAAAAAAAAAZAAAAAEAAABAAAAAAAAAAAAAAAAAAAAAAAAAAAAAAAAAAAAAAAAAAAAAAAAAAAAAAAAAAAAAAAAAAAAAAAAAAAAAAAAAAAAAAAAAAAAAAAAAAAAAAAAAAAAAAAAAAAAAFAAAADwAAAAAAAAAAAAAAAAAAAkUAAAAAQAAABQAAAAUAAAAFAAAAAEAAAAAAAAAZAAAAGQAAAAAAAAAZAAAAGQAAAAVAAAAYAAAAAAAAAAAAAAADwAAACADAAAAAAAAAAAAAAEAAACgMgAAVgcAAKr4//8BAAAAf39/AAEAAABkAAAAAAAAABQAAABAHwAAAAAAACYAAAAAAAAAwOD//wAAAAAmAAAAZAAAABYAAABMAAAAAAAAAAAAAAAEAAAAAAAAAAEAAABZWVkKAAAAACgAAAAoAAAAZAAAAGQAAAAAAAAAzMzMAAAAAABQAAAAUAAAAGQAAABkAAAAAAAAABcAAAAUAAAAAAAAAAAAAAD/fwAA/38AAAAAAAAJAAAABAAAAGdlODkeAAAAaAAAAAAAAAAAAAAAAAAAAAAAAAAAAAAAECcAABAnAAAAAAAAAAAAAAAAAAAAAAAAAAAAAAAAAAAAAAAAAAAAABQAAAAAAAAAwMD/AAAAAABkAAAAMgAAAAAAAABkAAAAAAAAAH9/fwAKAAAAIgAAABgAAAAAAAAAAAAAAAAAAAAAAAAAAAAAAAAAAAAkAAAAJAAAAAAAAAAHAAAAAAAAAAAAAAAAAAAAAAAAAAAAAAAAAAAAf39/ACUAAABYAAAAAAAAAAAAAAAAAAAAAAAAAAAAAAAAAAAAAAAAAAAAAAAAAAAAAAAAAAAAAAA/AAAAAAAAAKCGAQAAAAAAAAAAAAAAAAAMAAAAAQAAAAAAAAAAAAAAAAAAAB8AAABUAAAAAAAABQAAAAEAAAAAAAAAAAAAAAAAAAAAAAAAAAAAAAAAAAAAAAAAAAAAAAJ/f38AAAAAA8zMzADAwP8Af39/AAAAAAAAAAAAAAAAAAAAAAAAAAAAIQAAABgAAAAUAAAAnAIAALMLAAAHNwAAuScAABAAAAAmAAAACAAAAL2/AAD/HwAA"/>
+                <pr:smNativeData xmlns:pr="smNativeData" xmlns="smNativeData" val="SMDATA_15_9kV5ZhMAAAAlAAAAZAAAAA0AAAAAkAAAAJAAAACQAAAAkAAAAAAAAAAAAAAAAAAAAAEAAABQAAAAAAAAAAAA4D8AAAAAAADgPwAAAAAAAOA/AAAAAAAA4D8AAAAAAADgPwAAAAAAAOA/AAAAAAAA4D8AAAAAAADgPwAAAAAAAOA/AAAAAAAA4D8CAAAAjAAAAAAAAAAAAAAAQoX0DP///wgAAAAAAAAAAAAAAAAAAAAAAAAAAAAAAAAAAAAAZAAAAAEAAABAAAAAAAAAAAAAAAAAAAAAAAAAAAAAAAAAAAAAAAAAAAAAAAAAAAAAAAAAAAAAAAAAAAAAAAAAAAAAAAAAAAAAAAAAAAAAAAAAAAAAAAAAAAAAAAAAAAAAFAAAADwAAAAAAAAAAAAAAAAAAAkUAAAAAQAAABQAAAAUAAAAFAAAAAEAAAAAAAAAZAAAAGQAAAAAAAAAZAAAAGQAAAAVAAAAYAAAAAAAAAAAAAAADwAAACADAAAAAAAAAAAAAAEAAACgMgAAVgcAAKr4//8BAAAAf39/AAEAAABkAAAAAAAAABQAAABAHwAAAAAAACYAAAAAAAAAwOD//wAAAAAmAAAAZAAAABYAAABMAAAAAAAAAAAAAAAEAAAAAAAAAAEAAABZWVkKAAAAACgAAAAoAAAAZAAAAGQAAAAAAAAAzMzMAAAAAABQAAAAUAAAAGQAAABkAAAAAAAAABcAAAAUAAAAAAAAAAAAAAD/fwAA/38AAAAAAAAJAAAABAAAAGdlODkeAAAAaAAAAAAAAAAAAAAAAAAAAAAAAAAAAAAAECcAABAnAAAAAAAAAAAAAAAAAAAAAAAAAAAAAAAAAAAAAAAAAAAAABQAAAAAAAAAwMD/AAAAAABkAAAAMgAAAAAAAABkAAAAAAAAAH9/fwAKAAAAIgAAABgAAAAAAAAAAAAAAAAAAAAAAAAAAAAAAAAAAAAkAAAAJAAAAAAAAAAHAAAAAAAAAAAAAAAAAAAAAAAAAAAAAAAAAAAAf39/ACUAAABYAAAAAAAAAAAAAAAAAAAAAAAAAAAAAAAAAAAAAAAAAAAAAAAAAAAAAAAAAAAAAAA/AAAAAAAAAKCGAQAAAAAAAAAAAAAAAAAMAAAAAQAAAAAAAAAAAAAAAAAAAB8AAABUAAAAAAAABQAAAAEAAAAAAAAAAAAAAAAAAAAAAAAAAAAAAAAAAAAAAAAAAAAAAAJ/f38AAAAAA8zMzADAwP8Af39/AAAAAAAAAAAAAAAAAAAAAAAAAAAAIQAAABgAAAAUAAAAnAIAALMLAAAHNwAAuScAABAAAAAmAAAACAAAAL2/AAD/HwAA"/>
               </a:ext>
             </a:extLst>
           </p:cNvSpPr>
@@ -8068,7 +8068,7 @@
             <a:spLocks noGrp="1" noChangeArrowheads="1"/>
             <a:extLst>
               <a:ext uri="smNativeData">
-                <pr:smNativeData xmlns:pr="smNativeData" xmlns="smNativeData" val="SMDATA_15_FUV5ZhMAAAAlAAAAZAAAAA0AAAAAkAAAAJAAAACQAAAAkAAAAAAAAAABAAAAAAAAAAEAAABQAAAAAAAAAAAA4D8AAAAAAADgPwAAAAAAAOA/AAAAAAAA4D8AAAAAAADgPwAAAAAAAOA/AAAAAAAA4D8AAAAAAADgPwAAAAAAAOA/AAAAAAAA4D8CAAAAjAAAAAAAAAAAAAAAQoX0DP///wgAAAAAAAAAAAAAAAAAAAAAAAAAAAAAAAAAAAAAZAAAAAEAAABAAAAAAAAAAAAAAAAAAAAAAAAAAAAAAAAAAAAAAAAAAAAAAAAAAAAAAAAAAAAAAAAAAAAAAAAAAAAAAAAAAAAAAAAAAAAAAAAAAAAAAAAAAAAAAAAAAAAAFAAAADwAAAAAAAAAAAAAAAAAAAkUAAAAAQAAABQAAAAUAAAAFAAAAAEAAAAAAAAAZAAAAGQAAAAAAAAAZAAAAGQAAAAVAAAAYAAAAAAAAAAAAAAADwAAACADAAAAAAAAAAAAAAEAAACgMgAAVgcAAKr4//8BAAAAf39/AAEAAABkAAAAAAAAABQAAABAHwAAAAAAACYAAAAAAAAAwOD//wAAAAAmAAAAZAAAABYAAABMAAAAAAAAAAAAAAAEAAAAAAAAAAEAAABZWVkKAAAAACgAAAAoAAAAZAAAAGQAAAAAAAAAzMzMAAAAAABQAAAAUAAAAGQAAABkAAAAAAAAABcAAAAUAAAAAAAAAAAAAAD/fwAA/38AAAAAAAAJAAAABAAAAG0AOwAeAAAAaAAAAAAAAAAAAAAAAAAAAAAAAAAAAAAAECcAABAnAAAAAAAAAAAAAAAAAAAAAAAAAAAAAAAAAAAAAAAAAAAAABQAAAAAAAAAwMD/AAAAAABkAAAAMgAAAAAAAABkAAAAAAAAAH9/fwAKAAAAIgAAABgAAAAAAAAAAAAAAAAAAAAAAAAAAAAAAAAAAAAkAAAAJAAAAAAAAAAHAAAAAAAAAAAAAAAAAAAAAAAAAAAAAAAAAAAAf39/ACUAAABYAAAAAAAAAAAAAAAAAAAAAAAAAAAAAAAAAAAAAAAAAAAAAAAAAAAAAAAAAAAAAAA/AAAAAAAAAKCGAQAAAAAAAAAAAAAAAAAMAAAAAQAAAAAAAAAAAAAAAAAAAB8AAABUAAAAAAAABQAAAAEAAAAAAAAAAAAAAAAAAAAAAAAAAAAAAAAAAAAAAAAAAAAAAAJ/f38AAAAAA8zMzADAwP8Af39/AAAAAAAAAAAAAAAAAAAAAAAAAAAAIQAAABgAAAAUAAAAHjQAAEAmAAB/NwAAeikAABAAAAAmAAAACAAAAL2/AAD/HwAA"/>
+                <pr:smNativeData xmlns:pr="smNativeData" xmlns="smNativeData" val="SMDATA_15_9kV5ZhMAAAAlAAAAZAAAAA0AAAAAkAAAAJAAAACQAAAAkAAAAAAAAAABAAAAAAAAAAEAAABQAAAAAAAAAAAA4D8AAAAAAADgPwAAAAAAAOA/AAAAAAAA4D8AAAAAAADgPwAAAAAAAOA/AAAAAAAA4D8AAAAAAADgPwAAAAAAAOA/AAAAAAAA4D8CAAAAjAAAAAAAAAAAAAAAQoX0DP///wgAAAAAAAAAAAAAAAAAAAAAAAAAAAAAAAAAAAAAZAAAAAEAAABAAAAAAAAAAAAAAAAAAAAAAAAAAAAAAAAAAAAAAAAAAAAAAAAAAAAAAAAAAAAAAAAAAAAAAAAAAAAAAAAAAAAAAAAAAAAAAAAAAAAAAAAAAAAAAAAAAAAAFAAAADwAAAAAAAAAAAAAAAAAAAkUAAAAAQAAABQAAAAUAAAAFAAAAAEAAAAAAAAAZAAAAGQAAAAAAAAAZAAAAGQAAAAVAAAAYAAAAAAAAAAAAAAADwAAACADAAAAAAAAAAAAAAEAAACgMgAAVgcAAKr4//8BAAAAf39/AAEAAABkAAAAAAAAABQAAABAHwAAAAAAACYAAAAAAAAAwOD//wAAAAAmAAAAZAAAABYAAABMAAAAAAAAAAAAAAAEAAAAAAAAAAEAAABZWVkKAAAAACgAAAAoAAAAZAAAAGQAAAAAAAAAzMzMAAAAAABQAAAAUAAAAGQAAABkAAAAAAAAABcAAAAUAAAAAAAAAAAAAAD/fwAA/38AAAAAAAAJAAAABAAAAG0AOwAeAAAAaAAAAAAAAAAAAAAAAAAAAAAAAAAAAAAAECcAABAnAAAAAAAAAAAAAAAAAAAAAAAAAAAAAAAAAAAAAAAAAAAAABQAAAAAAAAAwMD/AAAAAABkAAAAMgAAAAAAAABkAAAAAAAAAH9/fwAKAAAAIgAAABgAAAAAAAAAAAAAAAAAAAAAAAAAAAAAAAAAAAAkAAAAJAAAAAAAAAAHAAAAAAAAAAAAAAAAAAAAAAAAAAAAAAAAAAAAf39/ACUAAABYAAAAAAAAAAAAAAAAAAAAAAAAAAAAAAAAAAAAAAAAAAAAAAAAAAAAAAAAAAAAAAA/AAAAAAAAAKCGAQAAAAAAAAAAAAAAAAAMAAAAAQAAAAAAAAAAAAAAAAAAAB8AAABUAAAAAAAABQAAAAEAAAAAAAAAAAAAAAAAAAAAAAAAAAAAAAAAAAAAAAAAAAAAAAJ/f38AAAAAA8zMzADAwP8Af39/AAAAAAAAAAAAAAAAAAAAAAAAAAAAIQAAABgAAAAUAAAAHjQAAEAmAAB/NwAAeikAABAAAAAmAAAACAAAAL2/AAD/HwAA"/>
               </a:ext>
             </a:extLst>
           </p:cNvSpPr>
@@ -8179,7 +8179,7 @@
               </a:spcAft>
               <a:buNone/>
             </a:pPr>
-            <a:fld id="{3FD90151-1FD2-8CF7-9C61-E9A24F2F6ABC}" type="slidenum">
+            <a:fld id="{3FDDFB4B-05D2-880D-9C65-F358B52B6AA6}" type="slidenum">
               <a:rPr lang="ru-ru" cap="none"/>
               <a:t/>
             </a:fld>
@@ -8836,7 +8836,7 @@
             <a:spLocks noGrp="1" noChangeArrowheads="1"/>
             <a:extLst>
               <a:ext uri="smNativeData">
-                <pr:smNativeData xmlns:pr="smNativeData" xmlns="smNativeData" val="SMDATA_15_FUV5ZhMAAAAlAAAAZAAAAA0AAAAAkAAAAJAAAACQAAAAkAAAAAAAAAAAAAAAAAAAAAEAAABQAAAAAAAAAAAA4D8AAAAAAADgPwAAAAAAAOA/AAAAAAAA4D8AAAAAAADgPwAAAAAAAOA/AAAAAAAA4D8AAAAAAADgPwAAAAAAAOA/AAAAAAAA4D8CAAAAjAAAAAAAAAAAAAAAQoX0DP///wgAAAAAAAAAAAAAAAAAAAAAAAAAAAAAAAAAAAAAZAAAAAEAAABAAAAAAAAAAAAAAAAAAAAAAAAAAAAAAAAAAAAAAAAAAAAAAAAAAAAAAAAAAAAAAAAAAAAAAAAAAAAAAAAAAAAAAAAAAAAAAAAAAAAAAAAAAAAAAAAAAAAAFAAAADwAAAAAAAAAAAAAAAAAAAkUAAAAAQAAABQAAAAUAAAAFAAAAAEAAAAAAAAAZAAAAGQAAAAAAAAAZAAAAGQAAAAVAAAAYAAAAAAAAAAAAAAADwAAACADAAAAAAAAAAAAAAEAAACgMgAAVgcAAKr4//8BAAAAf39/AAEAAABkAAAAAAAAABQAAABAHwAAAAAAACYAAAAAAAAAwOD//wAAAAAmAAAAZAAAABYAAABMAAAAAAAAAAAAAAAEAAAAAAAAAAEAAABZWVkKAAAAACgAAAAoAAAAZAAAAGQAAAAAAAAAzMzMAAAAAABQAAAAUAAAAGQAAABkAAAAAAAAABcAAAAUAAAAAAAAAAAAAAD/fwAA/38AAAAAAAAJAAAABAAAAAAAAAAeAAAAaAAAAAAAAAAAAAAAAAAAAAAAAAAAAAAAECcAABAnAAAAAAAAAAAAAAAAAAAAAAAAAAAAAAAAAAAAAAAAAAAAABQAAAAAAAAAwMD/AAAAAABkAAAAMgAAAAAAAABkAAAAAAAAAH9/fwAKAAAAIgAAABgAAAAAAAAAAAAAAAAAAAAAAAAAAAAAAAAAAAAkAAAAJAAAAAAAAAAHAAAAAAAAAAAAAAAAAAAAAAAAAAAAAAAAAAAAf39/ACUAAABYAAAAAAAAAAAAAAAAAAAAAAAAAAAAAAAAAAAAAAAAAAAAAAAAAAAAAAAAAAAAAAA/AAAAAAAAAKCGAQAAAAAAAAAAAAAAAAAMAAAAAQAAAAAAAAAAAAAAAAAAAB8AAABUAAAAQoX0Bf///wEAAAAAAAAAAAAAAAAAAAAAAAAAAAAAAAAAAAAAAAAAAAAAAAJ/f38AWVlZA8zMzADAwP8Af39/AAAAAAAAAAAAAAAAAAAAAAAAAAAAIQAAABgAAAAUAAAA5wQAAD8jAAD6IwAAvykAABAAAAAmAAAACAAAADwwAAAAAAAA"/>
+                <pr:smNativeData xmlns:pr="smNativeData" xmlns="smNativeData" val="SMDATA_15_9kV5ZhMAAAAlAAAAZAAAAA0AAAAAkAAAAJAAAACQAAAAkAAAAAAAAAAAAAAAAAAAAAEAAABQAAAAAAAAAAAA4D8AAAAAAADgPwAAAAAAAOA/AAAAAAAA4D8AAAAAAADgPwAAAAAAAOA/AAAAAAAA4D8AAAAAAADgPwAAAAAAAOA/AAAAAAAA4D8CAAAAjAAAAAAAAAAAAAAAQoX0DP///wgAAAAAAAAAAAAAAAAAAAAAAAAAAAAAAAAAAAAAZAAAAAEAAABAAAAAAAAAAAAAAAAAAAAAAAAAAAAAAAAAAAAAAAAAAAAAAAAAAAAAAAAAAAAAAAAAAAAAAAAAAAAAAAAAAAAAAAAAAAAAAAAAAAAAAAAAAAAAAAAAAAAAFAAAADwAAAAAAAAAAAAAAAAAAAkUAAAAAQAAABQAAAAUAAAAFAAAAAEAAAAAAAAAZAAAAGQAAAAAAAAAZAAAAGQAAAAVAAAAYAAAAAAAAAAAAAAADwAAACADAAAAAAAAAAAAAAEAAACgMgAAVgcAAKr4//8BAAAAf39/AAEAAABkAAAAAAAAABQAAABAHwAAAAAAACYAAAAAAAAAwOD//wAAAAAmAAAAZAAAABYAAABMAAAAAAAAAAAAAAAEAAAAAAAAAAEAAABZWVkKAAAAACgAAAAoAAAAZAAAAGQAAAAAAAAAzMzMAAAAAABQAAAAUAAAAGQAAABkAAAAAAAAABcAAAAUAAAAAAAAAAAAAAD/fwAA/38AAAAAAAAJAAAABAAAAAAAAAAeAAAAaAAAAAAAAAAAAAAAAAAAAAAAAAAAAAAAECcAABAnAAAAAAAAAAAAAAAAAAAAAAAAAAAAAAAAAAAAAAAAAAAAABQAAAAAAAAAwMD/AAAAAABkAAAAMgAAAAAAAABkAAAAAAAAAH9/fwAKAAAAIgAAABgAAAAAAAAAAAAAAAAAAAAAAAAAAAAAAAAAAAAkAAAAJAAAAAAAAAAHAAAAAAAAAAAAAAAAAAAAAAAAAAAAAAAAAAAAf39/ACUAAABYAAAAAAAAAAAAAAAAAAAAAAAAAAAAAAAAAAAAAAAAAAAAAAAAAAAAAAAAAAAAAAA/AAAAAAAAAKCGAQAAAAAAAAAAAAAAAAAMAAAAAQAAAAAAAAAAAAAAAAAAAB8AAABUAAAAQoX0Bf///wEAAAAAAAAAAAAAAAAAAAAAAAAAAAAAAAAAAAAAAAAAAAAAAAJ/f38AWVlZA8zMzADAwP8Af39/AAAAAAAAAAAAAAAAAAAAAAAAAAAAIQAAABgAAAAUAAAA5wQAAD8jAAD6IwAAvykAABAAAAAmAAAACAAAADwwAAAAAAAA"/>
               </a:ext>
             </a:extLst>
           </p:cNvSpPr>
@@ -8877,7 +8877,7 @@
             <a:spLocks noGrp="1" noChangeArrowheads="1"/>
             <a:extLst>
               <a:ext uri="smNativeData">
-                <pr:smNativeData xmlns:pr="smNativeData" xmlns="smNativeData" val="SMDATA_15_FUV5ZhMAAAAlAAAAZAAAAA0AAAAAkAAAAJAAAACQAAAAkAAAAAAAAAAAAAAAAAAAAAEAAABQAAAAAAAAAAAA4D8AAAAAAADgPwAAAAAAAOA/AAAAAAAA4D8AAAAAAADgPwAAAAAAAOA/AAAAAAAA4D8AAAAAAADgPwAAAAAAAOA/AAAAAAAA4D8CAAAAjAAAAAAAAAAAAAAAQoX0DP///wgAAAAAAAAAAAAAAAAAAAAAAAAAAAAAAAAAAAAAZAAAAAEAAABAAAAAAAAAAAAAAAAAAAAAAAAAAAAAAAAAAAAAAAAAAAAAAAAAAAAAAAAAAAAAAAAAAAAAAAAAAAAAAAAAAAAAAAAAAAAAAAAAAAAAAAAAAAAAAAAAAAAAFAAAADwAAAAAAAAAAAAAAAAAAAkUAAAAAQAAABQAAAAUAAAAFAAAAAEAAAAAAAAAZAAAAGQAAAAAAAAAZAAAAGQAAAAVAAAAYAAAAAAAAAAAAAAADwAAACADAAAAAAAAAAAAAAEAAACgMgAAVgcAAKr4//8BAAAAf39/AAEAAABkAAAAAAAAABQAAABAHwAAAAAAACYAAAAAAAAAwOD//wAAAAAmAAAAZAAAABYAAABMAAAAAAAAAAAAAAAEAAAAAAAAAAEAAABZWVkKAAAAACgAAAAoAAAAZAAAAGQAAAAAAAAAzMzMAAAAAABQAAAAUAAAAGQAAABkAAAAAAAAABcAAAAUAAAAAAAAAAAAAAD/fwAA/38AAAAAAAAJAAAABAAAAAAAAAAeAAAAaAAAAAAAAAAAAAAAAAAAAAAAAAAAAAAAECcAABAnAAAAAAAAAAAAAAAAAAAAAAAAAAAAAAAAAAAAAAAAAAAAABQAAAAAAAAAwMD/AAAAAABkAAAAMgAAAAAAAABkAAAAAAAAAH9/fwAKAAAAIgAAABgAAAAAAAAAAAAAAAAAAAAAAAAAAAAAAAAAAAAkAAAAJAAAAAAAAAAHAAAAAAAAAAAAAAAAAAAAAAAAAAAAAAAAAAAAf39/ACUAAABYAAAAAAAAAAAAAAAAAAAAAAAAAAAAAAAAAAAAAAAAAAAAAAAAAAAAAAAAAAAAAAA/AAAAAAAAAKCGAQAAAAAAAAAAAAAAAAAMAAAAAQAAAAAAAAAAAAAAAAAAAB8AAABUAAAAQoX0Bf///wEAAAAAAAAAAAAAAAAAAAAAAAAAAAAAAAAAAAAAAAAAAAAAAAJ/f38AWVlZA8zMzADAwP8Af39/AAAAAAAAAAAAAAAAAAAAAAAAAAAAIQAAABgAAAAUAAAA5wQAAMMPAACROAAAfyQAABAAAAAmAAAACAAAADwwAAAAAAAA"/>
+                <pr:smNativeData xmlns:pr="smNativeData" xmlns="smNativeData" val="SMDATA_15_9kV5ZhMAAAAlAAAAZAAAAA0AAAAAkAAAAJAAAACQAAAAkAAAAAAAAAAAAAAAAAAAAAEAAABQAAAAAAAAAAAA4D8AAAAAAADgPwAAAAAAAOA/AAAAAAAA4D8AAAAAAADgPwAAAAAAAOA/AAAAAAAA4D8AAAAAAADgPwAAAAAAAOA/AAAAAAAA4D8CAAAAjAAAAAAAAAAAAAAAQoX0DP///wgAAAAAAAAAAAAAAAAAAAAAAAAAAAAAAAAAAAAAZAAAAAEAAABAAAAAAAAAAAAAAAAAAAAAAAAAAAAAAAAAAAAAAAAAAAAAAAAAAAAAAAAAAAAAAAAAAAAAAAAAAAAAAAAAAAAAAAAAAAAAAAAAAAAAAAAAAAAAAAAAAAAAFAAAADwAAAAAAAAAAAAAAAAAAAkUAAAAAQAAABQAAAAUAAAAFAAAAAEAAAAAAAAAZAAAAGQAAAAAAAAAZAAAAGQAAAAVAAAAYAAAAAAAAAAAAAAADwAAACADAAAAAAAAAAAAAAEAAACgMgAAVgcAAKr4//8BAAAAf39/AAEAAABkAAAAAAAAABQAAABAHwAAAAAAACYAAAAAAAAAwOD//wAAAAAmAAAAZAAAABYAAABMAAAAAAAAAAAAAAAEAAAAAAAAAAEAAABZWVkKAAAAACgAAAAoAAAAZAAAAGQAAAAAAAAAzMzMAAAAAABQAAAAUAAAAGQAAABkAAAAAAAAABcAAAAUAAAAAAAAAAAAAAD/fwAA/38AAAAAAAAJAAAABAAAAAAAAAAeAAAAaAAAAAAAAAAAAAAAAAAAAAAAAAAAAAAAECcAABAnAAAAAAAAAAAAAAAAAAAAAAAAAAAAAAAAAAAAAAAAAAAAABQAAAAAAAAAwMD/AAAAAABkAAAAMgAAAAAAAABkAAAAAAAAAH9/fwAKAAAAIgAAABgAAAAAAAAAAAAAAAAAAAAAAAAAAAAAAAAAAAAkAAAAJAAAAAAAAAAHAAAAAAAAAAAAAAAAAAAAAAAAAAAAAAAAAAAAf39/ACUAAABYAAAAAAAAAAAAAAAAAAAAAAAAAAAAAAAAAAAAAAAAAAAAAAAAAAAAAAAAAAAAAAA/AAAAAAAAAKCGAQAAAAAAAAAAAAAAAAAMAAAAAQAAAAAAAAAAAAAAAAAAAB8AAABUAAAAQoX0Bf///wEAAAAAAAAAAAAAAAAAAAAAAAAAAAAAAAAAAAAAAAAAAAAAAAJ/f38AWVlZA8zMzADAwP8Af39/AAAAAAAAAAAAAAAAAAAAAAAAAAAAIQAAABgAAAAUAAAA5wQAAMMPAACROAAAfyQAABAAAAAmAAAACAAAADwwAAAAAAAA"/>
               </a:ext>
             </a:extLst>
           </p:cNvSpPr>
@@ -8966,7 +8966,7 @@
             <a:spLocks noGrp="1" noChangeArrowheads="1"/>
             <a:extLst>
               <a:ext uri="smNativeData">
-                <pr:smNativeData xmlns:pr="smNativeData" xmlns="smNativeData" val="SMDATA_15_FUV5ZhMAAAAlAAAAZAAAAA0AAAAAkAAAAJAAAACQAAAAkAAAAAAAAAAAAAAAAAAAAAEAAABQAAAAAAAAAAAA4D8AAAAAAADgPwAAAAAAAOA/AAAAAAAA4D8AAAAAAADgPwAAAAAAAOA/AAAAAAAA4D8AAAAAAADgPwAAAAAAAOA/AAAAAAAA4D8CAAAAjAAAAAAAAAAAAAAAQoX0DP///wgAAAAAAAAAAAAAAAAAAAAAAAAAAAAAAAAAAAAAZAAAAAEAAABAAAAAAAAAAAAAAAAAAAAAAAAAAAAAAAAAAAAAAAAAAAAAAAAAAAAAAAAAAAAAAAAAAAAAAAAAAAAAAAAAAAAAAAAAAAAAAAAAAAAAAAAAAAAAAAAAAAAAFAAAADwAAAAAAAAAAAAAAAAAAAkUAAAAAQAAABQAAAAUAAAAFAAAAAEAAAAAAAAAZAAAAGQAAAAAAAAAZAAAAGQAAAAVAAAAYAAAAAAAAAAAAAAADwAAACADAAAAAAAAAAAAAAEAAACgMgAAVgcAAKr4//8BAAAAf39/AAEAAABkAAAAAAAAABQAAABAHwAAAAAAACYAAAAAAAAAwOD//wAAAAAmAAAAZAAAABYAAABMAAAAAAAAAAAAAAAEAAAAAAAAAAEAAABZWVkKAAAAACgAAAAoAAAAZAAAAGQAAAAAAAAAzMzMAAAAAABQAAAAUAAAAGQAAABkAAAAAAAAABcAAAAUAAAAAAAAAAAAAAD/fwAA/38AAAAAAAAJAAAABAAAAAAAAAAeAAAAaAAAAAAAAAAAAAAAAAAAAAAAAAAAAAAAECcAABAnAAAAAAAAAAAAAAAAAAAAAAAAAAAAAAAAAAAAAAAAAAAAABQAAAAAAAAAwMD/AAAAAABkAAAAMgAAAAAAAABkAAAAAAAAAH9/fwAKAAAAIgAAABgAAAAAAAAAAAAAAAAAAAAAAAAAAAAAAAAAAAAkAAAAJAAAAAAAAAAHAAAAAAAAAAAAAAAAAAAAAAAAAAAAAAAAAAAAf39/ACUAAABYAAAAAAAAAAAAAAAAAAAAAAAAAAAAAAAAAAAAAAAAAAAAAAAAAAAAAAAAAAAAAAA/AAAAAAAAAKCGAQAAAAAAAAAAAAAAAAAMAAAAAQAAAAAAAAAAAAAAAAAAAB8AAABUAAAAAAAABQAAAAEAAAAAAAAAAAAAAAAAAAAAAAAAAAAAAAAAAAAAAAAAAAAAAAJ/f38AWVlZA8zMzADAwP8Af39/AAAAAAAAAAAAAAAAAAAAAAAAAAAAIQAAABgAAAAUAAAAFAMAALYCAAB/NwAAvwoAABAAAAAmAAAACAAAAAAAAAAAAAAA"/>
+                <pr:smNativeData xmlns:pr="smNativeData" xmlns="smNativeData" val="SMDATA_15_9kV5ZhMAAAAlAAAAZAAAAA0AAAAAkAAAAJAAAACQAAAAkAAAAAAAAAAAAAAAAAAAAAEAAABQAAAAAAAAAAAA4D8AAAAAAADgPwAAAAAAAOA/AAAAAAAA4D8AAAAAAADgPwAAAAAAAOA/AAAAAAAA4D8AAAAAAADgPwAAAAAAAOA/AAAAAAAA4D8CAAAAjAAAAAAAAAAAAAAAQoX0DP///wgAAAAAAAAAAAAAAAAAAAAAAAAAAAAAAAAAAAAAZAAAAAEAAABAAAAAAAAAAAAAAAAAAAAAAAAAAAAAAAAAAAAAAAAAAAAAAAAAAAAAAAAAAAAAAAAAAAAAAAAAAAAAAAAAAAAAAAAAAAAAAAAAAAAAAAAAAAAAAAAAAAAAFAAAADwAAAAAAAAAAAAAAAAAAAkUAAAAAQAAABQAAAAUAAAAFAAAAAEAAAAAAAAAZAAAAGQAAAAAAAAAZAAAAGQAAAAVAAAAYAAAAAAAAAAAAAAADwAAACADAAAAAAAAAAAAAAEAAACgMgAAVgcAAKr4//8BAAAAf39/AAEAAABkAAAAAAAAABQAAABAHwAAAAAAACYAAAAAAAAAwOD//wAAAAAmAAAAZAAAABYAAABMAAAAAAAAAAAAAAAEAAAAAAAAAAEAAABZWVkKAAAAACgAAAAoAAAAZAAAAGQAAAAAAAAAzMzMAAAAAABQAAAAUAAAAGQAAABkAAAAAAAAABcAAAAUAAAAAAAAAAAAAAD/fwAA/38AAAAAAAAJAAAABAAAAAAAAAAeAAAAaAAAAAAAAAAAAAAAAAAAAAAAAAAAAAAAECcAABAnAAAAAAAAAAAAAAAAAAAAAAAAAAAAAAAAAAAAAAAAAAAAABQAAAAAAAAAwMD/AAAAAABkAAAAMgAAAAAAAABkAAAAAAAAAH9/fwAKAAAAIgAAABgAAAAAAAAAAAAAAAAAAAAAAAAAAAAAAAAAAAAkAAAAJAAAAAAAAAAHAAAAAAAAAAAAAAAAAAAAAAAAAAAAAAAAAAAAf39/ACUAAABYAAAAAAAAAAAAAAAAAAAAAAAAAAAAAAAAAAAAAAAAAAAAAAAAAAAAAAAAAAAAAAA/AAAAAAAAAKCGAQAAAAAAAAAAAAAAAAAMAAAAAQAAAAAAAAAAAAAAAAAAAB8AAABUAAAAAAAABQAAAAEAAAAAAAAAAAAAAAAAAAAAAAAAAAAAAAAAAAAAAAAAAAAAAAJ/f38AWVlZA8zMzADAwP8Af39/AAAAAAAAAAAAAAAAAAAAAAAAAAAAIQAAABgAAAAUAAAAFAMAALYCAAB/NwAAvwoAABAAAAAmAAAACAAAAAAAAAAAAAAA"/>
               </a:ext>
             </a:extLst>
           </p:cNvSpPr>
@@ -8993,7 +8993,7 @@
             <a:spLocks noGrp="1" noChangeArrowheads="1"/>
             <a:extLst>
               <a:ext uri="smNativeData">
-                <pr:smNativeData xmlns:pr="smNativeData" xmlns="smNativeData" val="SMDATA_15_FUV5ZhMAAAAlAAAAZAAAAA0AAAAAkAAAAJAAAACQAAAAkAAAAAAAAAAAAAAAAAAAAAEAAABQAAAAAAAAAAAA4D8AAAAAAADgPwAAAAAAAOA/AAAAAAAA4D8AAAAAAADgPwAAAAAAAOA/AAAAAAAA4D8AAAAAAADgPwAAAAAAAOA/AAAAAAAA4D8CAAAAjAAAAAAAAAAAAAAAQoX0DP///wgAAAAAAAAAAAAAAAAAAAAAAAAAAAAAAAAAAAAAZAAAAAEAAABAAAAAAAAAAAAAAAAAAAAAAAAAAAAAAAAAAAAAAAAAAAAAAAAAAAAAAAAAAAAAAAAAAAAAAAAAAAAAAAAAAAAAAAAAAAAAAAAAAAAAAAAAAAAAAAAAAAAAFAAAADwAAAAAAAAAAAAAAAAAAAkUAAAAAQAAABQAAAAUAAAAFAAAAAEAAAAAAAAAZAAAAGQAAAAAAAAAZAAAAGQAAAAVAAAAYAAAAAAAAAAAAAAADwAAACADAAAAAAAAAAAAAAEAAACgMgAAVgcAAKr4//8BAAAAf39/AAEAAABkAAAAAAAAABQAAABAHwAAAAAAACYAAAAAAAAAwOD//wAAAAAmAAAAZAAAABYAAABMAAAAAAAAAAAAAAAEAAAAAAAAAAEAAABZWVkKAAAAACgAAAAoAAAAZAAAAGQAAAAAAAAAzMzMAAAAAABQAAAAUAAAAGQAAABkAAAAAAAAABcAAAAUAAAAAAAAAAAAAAD/fwAA/38AAAAAAAAJAAAABAAAAAAAAAAeAAAAaAAAAAAAAAAAAAAAAAAAAAAAAAAAAAAAECcAABAnAAAAAAAAAAAAAAAAAAAAAAAAAAAAAAAAAAAAAAAAAAAAABQAAAAAAAAAwMD/AAAAAABkAAAAMgAAAAAAAABkAAAAAAAAAH9/fwAKAAAAIgAAABgAAAAAAAAAAAAAAAAAAAAAAAAAAAAAAAAAAAAkAAAAJAAAAAAAAAAHAAAAAAAAAAAAAAAAAAAAAAAAAAAAAAAAAAAAf39/ACUAAABYAAAAAAAAAAAAAAAAAAAAAAAAAAAAAAAAAAAAAAAAAAAAAAAAAAAAAAAAAAAAAAA/AAAAAAAAAKCGAQAAAAAAAAAAAAAAAAAMAAAAAQAAAAAAAAAAAAAAAAAAAB8AAABUAAAAAAAABQAAAAEAAAAAAAAAAAAAAAAAAAAAAAAAAAAAAAAAAAAAAAAAAAAAAAJ/f38AWVlZA8zMzADAwP8Af39/AAAAAAAAAAAAAAAAAAAAAAAAAAAAIQAAABgAAAAUAAAAFAMAALMLAAB/NwAAuScAABAAAAAmAAAACAAAAAAAAAAAAAAA"/>
+                <pr:smNativeData xmlns:pr="smNativeData" xmlns="smNativeData" val="SMDATA_15_9kV5ZhMAAAAlAAAAZAAAAA0AAAAAkAAAAJAAAACQAAAAkAAAAAAAAAAAAAAAAAAAAAEAAABQAAAAAAAAAAAA4D8AAAAAAADgPwAAAAAAAOA/AAAAAAAA4D8AAAAAAADgPwAAAAAAAOA/AAAAAAAA4D8AAAAAAADgPwAAAAAAAOA/AAAAAAAA4D8CAAAAjAAAAAAAAAAAAAAAQoX0DP///wgAAAAAAAAAAAAAAAAAAAAAAAAAAAAAAAAAAAAAZAAAAAEAAABAAAAAAAAAAAAAAAAAAAAAAAAAAAAAAAAAAAAAAAAAAAAAAAAAAAAAAAAAAAAAAAAAAAAAAAAAAAAAAAAAAAAAAAAAAAAAAAAAAAAAAAAAAAAAAAAAAAAAFAAAADwAAAAAAAAAAAAAAAAAAAkUAAAAAQAAABQAAAAUAAAAFAAAAAEAAAAAAAAAZAAAAGQAAAAAAAAAZAAAAGQAAAAVAAAAYAAAAAAAAAAAAAAADwAAACADAAAAAAAAAAAAAAEAAACgMgAAVgcAAKr4//8BAAAAf39/AAEAAABkAAAAAAAAABQAAABAHwAAAAAAACYAAAAAAAAAwOD//wAAAAAmAAAAZAAAABYAAABMAAAAAAAAAAAAAAAEAAAAAAAAAAEAAABZWVkKAAAAACgAAAAoAAAAZAAAAGQAAAAAAAAAzMzMAAAAAABQAAAAUAAAAGQAAABkAAAAAAAAABcAAAAUAAAAAAAAAAAAAAD/fwAA/38AAAAAAAAJAAAABAAAAAAAAAAeAAAAaAAAAAAAAAAAAAAAAAAAAAAAAAAAAAAAECcAABAnAAAAAAAAAAAAAAAAAAAAAAAAAAAAAAAAAAAAAAAAAAAAABQAAAAAAAAAwMD/AAAAAABkAAAAMgAAAAAAAABkAAAAAAAAAH9/fwAKAAAAIgAAABgAAAAAAAAAAAAAAAAAAAAAAAAAAAAAAAAAAAAkAAAAJAAAAAAAAAAHAAAAAAAAAAAAAAAAAAAAAAAAAAAAAAAAAAAAf39/ACUAAABYAAAAAAAAAAAAAAAAAAAAAAAAAAAAAAAAAAAAAAAAAAAAAAAAAAAAAAAAAAAAAAA/AAAAAAAAAKCGAQAAAAAAAAAAAAAAAAAMAAAAAQAAAAAAAAAAAAAAAAAAAB8AAABUAAAAAAAABQAAAAEAAAAAAAAAAAAAAAAAAAAAAAAAAAAAAAAAAAAAAAAAAAAAAAJ/f38AWVlZA8zMzADAwP8Af39/AAAAAAAAAAAAAAAAAAAAAAAAAAAAIQAAABgAAAAUAAAAFAMAALMLAAB/NwAAuScAABAAAAAmAAAACAAAAAAAAAAAAAAA"/>
               </a:ext>
             </a:extLst>
           </p:cNvSpPr>
@@ -9026,7 +9026,7 @@
             <a:picLocks noChangeAspect="1"/>
             <a:extLst>
               <a:ext uri="smNativeData">
-                <pr:smNativeData xmlns:pr="smNativeData" xmlns="smNativeData" val="SMDATA_17_FUV5ZhMAAAAlAAAAEQAAAC8BAAAAkAAAAEgAAACQAAAASAAAAAAAAAAAAAAAAAAAAAEAAABQAAAAAAAAAAAA4D8AAAAAAADgPwAAAAAAAOA/AAAAAAAA4D8AAAAAAADgPwAAAAAAAOA/AAAAAAAA4D8AAAAAAADgPwAAAAAAAOA/AAAAAAAA4D8CAAAAjAAAAAAAAAAAAAAAQoX0DP///wgAAAAAAAAAAAAAAAAAAAAAAAAAAAAAAAAAAAAAZAAAAAEAAABAAAAAAAAAAAAAAAAAAAAAAAAAAAAAAAAAAAAAAAAAAAAAAAAAAAAAAAAAAAAAAAAAAAAAAAAAAAAAAAAAAAAAAAAAAAAAAAAAAAAAAAAAAAAAAAAAAAAAFAAAADwAAAAAAAAAAAAAAAAAAAkUAAAAAQAAABQAAAAUAAAAFAAAAAEAAAAAAAAAZAAAAGQAAAAAAAAAZAAAAGQAAAAVAAAAYAAAAAAAAAAAAAAADwAAACADAAAAAAAAAAAAAAEAAACgMgAAVgcAAKr4//8BAAAAf39/AAEAAABkAAAAAAAAABQAAABAHwAAAAAAACYAAAAAAAAAwOD//wAAAAAmAAAAZAAAABYAAABMAAAAAAAAAAAAAAAEAAAAAAAAAAEAAABZWVkKAAAAACgAAAAoAAAAZAAAAGQAAAAAAAAAzMzMAAAAAABQAAAAUAAAAGQAAABkAAAAAAAAAAcAAAA4AAAAAAAAAAAAAAAAAAAA////AAAAAAAAAAAAAAAAAAAAAAAAAAAAAAAAAAAAAABkAAAAZAAAAAAAAAAjAAAABAAAAGQAAAAXAAAAFAAAAAAAAAAAAAAA/38AAP9/AAAAAAAACQAAAAQAAAABAAAAHgAAAGgAAAAAAAAAAAAAAAAAAAAAAAAAAAAAABAnAAAQJwAAAAAAAAAAAAAAAAAAAAAAAAAAAAAAAAAAAAAAAAAAAAAUAAAAAAAAAMDA/wAAAAAAZAAAADIAAAAAAAAAZAAAAAAAAAB/f38ACgAAACIAAAAYAAAAAAAAAAAAAAAAAAAAAAAAAAAAAAAAAAAAJAAAACQAAAAAAAAABwAAAAAAAAAAAAAAAAAAAAAAAAAAAAAAAAAAAH9/fwAlAAAAWAAAAAAAAAAAAAAAAAAAAAAAAAAAAAAAAAAAAAAAAAAAAAAAAAAAAAAAAAAAAAAAPwAAAAAAAACghgEAAAAAAAAAAAAAAAAADAAAAAEAAAAAAAAAAAAAAAAAAAAfAAAAVAAAAEKF9AX///8BAAAAAAAAAAAAAAAAAAAAAAAAAAAAAAAAAAAAAAAAAAAAAAACf39/AFlZWQPMzMwAwMD/AH9/fwAAAAAAAAAAAAAAAAD///8AAAAAACEAAAAYAAAAFAAAAOwDAADNDgAA7yIAAA4nAAAQAAAAJgAAAAgAAAD//////////w=="/>
+                <pr:smNativeData xmlns:pr="smNativeData" xmlns="smNativeData" val="SMDATA_17_9kV5ZhMAAAAlAAAAEQAAAC8BAAAAkAAAAEgAAACQAAAASAAAAAAAAAAAAAAAAAAAAAEAAABQAAAAAAAAAAAA4D8AAAAAAADgPwAAAAAAAOA/AAAAAAAA4D8AAAAAAADgPwAAAAAAAOA/AAAAAAAA4D8AAAAAAADgPwAAAAAAAOA/AAAAAAAA4D8CAAAAjAAAAAAAAAAAAAAAQoX0DP///wgAAAAAAAAAAAAAAAAAAAAAAAAAAAAAAAAAAAAAZAAAAAEAAABAAAAAAAAAAAAAAAAAAAAAAAAAAAAAAAAAAAAAAAAAAAAAAAAAAAAAAAAAAAAAAAAAAAAAAAAAAAAAAAAAAAAAAAAAAAAAAAAAAAAAAAAAAAAAAAAAAAAAFAAAADwAAAAAAAAAAAAAAAAAAAkUAAAAAQAAABQAAAAUAAAAFAAAAAEAAAAAAAAAZAAAAGQAAAAAAAAAZAAAAGQAAAAVAAAAYAAAAAAAAAAAAAAADwAAACADAAAAAAAAAAAAAAEAAACgMgAAVgcAAKr4//8BAAAAf39/AAEAAABkAAAAAAAAABQAAABAHwAAAAAAACYAAAAAAAAAwOD//wAAAAAmAAAAZAAAABYAAABMAAAAAAAAAAAAAAAEAAAAAAAAAAEAAABZWVkKAAAAACgAAAAoAAAAZAAAAGQAAAAAAAAAzMzMAAAAAABQAAAAUAAAAGQAAABkAAAAAAAAAAcAAAA4AAAAAAAAAAAAAAAAAAAA////AAAAAAAAAAAAAAAAAAAAAAAAAAAAAAAAAAAAAABkAAAAZAAAAAAAAAAjAAAABAAAAGQAAAAXAAAAFAAAAAAAAAAAAAAA/38AAP9/AAAAAAAACQAAAAQAAAABAAAAHgAAAGgAAAAAAAAAAAAAAAAAAAAAAAAAAAAAABAnAAAQJwAAAAAAAAAAAAAAAAAAAAAAAAAAAAAAAAAAAAAAAAAAAAAUAAAAAAAAAMDA/wAAAAAAZAAAADIAAAAAAAAAZAAAAAAAAAB/f38ACgAAACIAAAAYAAAAAAAAAAAAAAAAAAAAAAAAAAAAAAAAAAAAJAAAACQAAAAAAAAABwAAAAAAAAAAAAAAAAAAAAAAAAAAAAAAAAAAAH9/fwAlAAAAWAAAAAAAAAAAAAAAAAAAAAAAAAAAAAAAAAAAAAAAAAAAAAAAAAAAAAAAAAAAAAAAPwAAAAAAAACghgEAAAAAAAAAAAAAAAAADAAAAAEAAAAAAAAAAAAAAAAAAAAfAAAAVAAAAEKF9AX///8BAAAAAAAAAAAAAAAAAAAAAAAAAAAAAAAAAAAAAAAAAAAAAAACf39/AFlZWQPMzMwAwMD/AH9/fwAAAAAAAAAAAAAAAAD///8AAAAAACEAAAAYAAAAFAAAAOwDAADNDgAA7yIAAA4nAAAQAAAAJgAAAAgAAAD//////////w=="/>
               </a:ext>
             </a:extLst>
           </p:cNvPicPr>
@@ -9092,7 +9092,7 @@
             <a:spLocks noGrp="1" noChangeArrowheads="1"/>
             <a:extLst>
               <a:ext uri="smNativeData">
-                <pr:smNativeData xmlns:pr="smNativeData" xmlns="smNativeData" val="SMDATA_15_FUV5ZhMAAAAlAAAAZAAAAA0AAAAAkAAAAJAAAACQAAAAkAAAAAAAAAAAAAAAAAAAAAEAAABQAAAAAAAAAAAA4D8AAAAAAADgPwAAAAAAAOA/AAAAAAAA4D8AAAAAAADgPwAAAAAAAOA/AAAAAAAA4D8AAAAAAADgPwAAAAAAAOA/AAAAAAAA4D8CAAAAjAAAAAAAAAAAAAAAQoX0DP///wgAAAAAAAAAAAAAAAAAAAAAAAAAAAAAAAAAAAAAZAAAAAEAAABAAAAAAAAAAAAAAAAAAAAAAAAAAAAAAAAAAAAAAAAAAAAAAAAAAAAAAAAAAAAAAAAAAAAAAAAAAAAAAAAAAAAAAAAAAAAAAAAAAAAAAAAAAAAAAAAAAAAAFAAAADwAAAAAAAAAAAAAAAAAAAkUAAAAAQAAABQAAAAUAAAAFAAAAAEAAAAAAAAAZAAAAGQAAAAAAAAAZAAAAGQAAAAVAAAAYAAAAAAAAAAAAAAADwAAACADAAAAAAAAAAAAAAEAAACgMgAAVgcAAKr4//8BAAAAf39/AAEAAABkAAAAAAAAABQAAABAHwAAAAAAACYAAAAAAAAAwOD//wAAAAAmAAAAZAAAABYAAABMAAAAAAAAAAAAAAAEAAAAAAAAAAEAAABZWVkKAAAAACgAAAAoAAAAZAAAAGQAAAAAAAAAzMzMAAAAAABQAAAAUAAAAGQAAABkAAAAAAAAABcAAAAUAAAAAAAAAAAAAAD/fwAA/38AAAAAAAAJAAAABAAAAAAAAAAeAAAAaAAAAAAAAAAAAAAAAAAAAAAAAAAAAAAAECcAABAnAAAAAAAAAAAAAAAAAAAAAAAAAAAAAAAAAAAAAAAAAAAAABQAAAAAAAAAwMD/AAAAAABkAAAAMgAAAAAAAABkAAAAAAAAAH9/fwAKAAAAIgAAABgAAAAAAAAAAAAAAAAAAAAAAAAAAAAAAAAAAAAkAAAAJAAAAAAAAAAHAAAAAAAAAAAAAAAAAAAAAAAAAAAAAAAAAAAAf39/ACUAAABYAAAAAAAAAAAAAAAAAAAAAAAAAAAAAAAAAAAAAAAAAAAAAAAAAAAAAAAAAAAAAAA/AAAAAAAAAKCGAQAAAAAAAAAAAAAAAAAMAAAAAQAAAAAAAAAAAAAAAAAAAB8AAABUAAAAAAAABQAAAAEAAAAAAAAAAAAAAAAAAAAAAAAAAAAAAAAAAAAAAAAAAAAAAAJ/f38AWVlZA8zMzADAwP8Af39/AAAAAAAAAAAAAAAAAAAAAAAAAAAAIQAAABgAAAAUAAAAFAMAALYCAAB/NwAAvwoAABAAAAAmAAAACAAAAAAAAAAAAAAA"/>
+                <pr:smNativeData xmlns:pr="smNativeData" xmlns="smNativeData" val="SMDATA_15_9kV5ZhMAAAAlAAAAZAAAAA0AAAAAkAAAAJAAAACQAAAAkAAAAAAAAAAAAAAAAAAAAAEAAABQAAAAAAAAAAAA4D8AAAAAAADgPwAAAAAAAOA/AAAAAAAA4D8AAAAAAADgPwAAAAAAAOA/AAAAAAAA4D8AAAAAAADgPwAAAAAAAOA/AAAAAAAA4D8CAAAAjAAAAAAAAAAAAAAAQoX0DP///wgAAAAAAAAAAAAAAAAAAAAAAAAAAAAAAAAAAAAAZAAAAAEAAABAAAAAAAAAAAAAAAAAAAAAAAAAAAAAAAAAAAAAAAAAAAAAAAAAAAAAAAAAAAAAAAAAAAAAAAAAAAAAAAAAAAAAAAAAAAAAAAAAAAAAAAAAAAAAAAAAAAAAFAAAADwAAAAAAAAAAAAAAAAAAAkUAAAAAQAAABQAAAAUAAAAFAAAAAEAAAAAAAAAZAAAAGQAAAAAAAAAZAAAAGQAAAAVAAAAYAAAAAAAAAAAAAAADwAAACADAAAAAAAAAAAAAAEAAACgMgAAVgcAAKr4//8BAAAAf39/AAEAAABkAAAAAAAAABQAAABAHwAAAAAAACYAAAAAAAAAwOD//wAAAAAmAAAAZAAAABYAAABMAAAAAAAAAAAAAAAEAAAAAAAAAAEAAABZWVkKAAAAACgAAAAoAAAAZAAAAGQAAAAAAAAAzMzMAAAAAABQAAAAUAAAAGQAAABkAAAAAAAAABcAAAAUAAAAAAAAAAAAAAD/fwAA/38AAAAAAAAJAAAABAAAAAAAAAAeAAAAaAAAAAAAAAAAAAAAAAAAAAAAAAAAAAAAECcAABAnAAAAAAAAAAAAAAAAAAAAAAAAAAAAAAAAAAAAAAAAAAAAABQAAAAAAAAAwMD/AAAAAABkAAAAMgAAAAAAAABkAAAAAAAAAH9/fwAKAAAAIgAAABgAAAAAAAAAAAAAAAAAAAAAAAAAAAAAAAAAAAAkAAAAJAAAAAAAAAAHAAAAAAAAAAAAAAAAAAAAAAAAAAAAAAAAAAAAf39/ACUAAABYAAAAAAAAAAAAAAAAAAAAAAAAAAAAAAAAAAAAAAAAAAAAAAAAAAAAAAAAAAAAAAA/AAAAAAAAAKCGAQAAAAAAAAAAAAAAAAAMAAAAAQAAAAAAAAAAAAAAAAAAAB8AAABUAAAAAAAABQAAAAEAAAAAAAAAAAAAAAAAAAAAAAAAAAAAAAAAAAAAAAAAAAAAAAJ/f38AWVlZA8zMzADAwP8Af39/AAAAAAAAAAAAAAAAAAAAAAAAAAAAIQAAABgAAAAUAAAAFAMAALYCAAB/NwAAvwoAABAAAAAmAAAACAAAAAAAAAAAAAAA"/>
               </a:ext>
             </a:extLst>
           </p:cNvSpPr>
@@ -9119,7 +9119,7 @@
             <a:spLocks noGrp="1" noChangeArrowheads="1"/>
             <a:extLst>
               <a:ext uri="smNativeData">
-                <pr:smNativeData xmlns:pr="smNativeData" xmlns="smNativeData" val="SMDATA_15_FUV5ZhMAAAAlAAAAZAAAAA0AAAAAkAAAAJAAAACQAAAAkAAAAAAAAAAAAAAAAAAAAAEAAABQAAAAAAAAAAAA4D8AAAAAAADgPwAAAAAAAOA/AAAAAAAA4D8AAAAAAADgPwAAAAAAAOA/AAAAAAAA4D8AAAAAAADgPwAAAAAAAOA/AAAAAAAA4D8CAAAAjAAAAAAAAAAAAAAAQoX0DP///wgAAAAAAAAAAAAAAAAAAAAAAAAAAAAAAAAAAAAAZAAAAAEAAABAAAAAAAAAAAAAAAAAAAAAAAAAAAAAAAAAAAAAAAAAAAAAAAAAAAAAAAAAAAAAAAAAAAAAAAAAAAAAAAAAAAAAAAAAAAAAAAAAAAAAAAAAAAAAAAAAAAAAFAAAADwAAAAAAAAAAAAAAAAAAAkUAAAAAQAAABQAAAAUAAAAFAAAAAEAAAAAAAAAZAAAAGQAAAAAAAAAZAAAAGQAAAAVAAAAYAAAAAAAAAAAAAAADwAAACADAAAAAAAAAAAAAAEAAACgMgAAVgcAAKr4//8BAAAAf39/AAEAAABkAAAAAAAAABQAAABAHwAAAAAAACYAAAAAAAAAwOD//wAAAAAmAAAAZAAAABYAAABMAAAAAAAAAAAAAAAEAAAAAAAAAAEAAABZWVkKAAAAACgAAAAoAAAAZAAAAGQAAAAAAAAAzMzMAAAAAABQAAAAUAAAAGQAAABkAAAAAAAAABcAAAAUAAAAAAAAAAAAAAD/fwAA/38AAAAAAAAJAAAABAAAAAAAAAAeAAAAaAAAAAAAAAAAAAAAAAAAAAAAAAAAAAAAECcAABAnAAAAAAAAAAAAAAAAAAAAAAAAAAAAAAAAAAAAAAAAAAAAABQAAAAAAAAAwMD/AAAAAABkAAAAMgAAAAAAAABkAAAAAAAAAH9/fwAKAAAAIgAAABgAAAAAAAAAAAAAAAAAAAAAAAAAAAAAAAAAAAAkAAAAJAAAAAAAAAAHAAAAAAAAAAAAAAAAAAAAAAAAAAAAAAAAAAAAf39/ACUAAABYAAAAAAAAAAAAAAAAAAAAAAAAAAAAAAAAAAAAAAAAAAAAAAAAAAAAAAAAAAAAAAA/AAAAAAAAAKCGAQAAAAAAAAAAAAAAAAAMAAAAAQAAAAAAAAAAAAAAAAAAAB8AAABUAAAAAAAABQAAAAEAAAAAAAAAAAAAAAAAAAAAAAAAAAAAAAAAAAAAAAAAAAAAAAJ/f38AWVlZA8zMzADAwP8Af39/AAAAAAAAAAAAAAAAAAAAAAAAAAAAIQAAABgAAAAUAAAAFAMAALMLAAB/NwAAuScAABAAAAAmAAAACAAAAAAAAAAAAAAA"/>
+                <pr:smNativeData xmlns:pr="smNativeData" xmlns="smNativeData" val="SMDATA_15_9kV5ZhMAAAAlAAAAZAAAAA0AAAAAkAAAAJAAAACQAAAAkAAAAAAAAAAAAAAAAAAAAAEAAABQAAAAAAAAAAAA4D8AAAAAAADgPwAAAAAAAOA/AAAAAAAA4D8AAAAAAADgPwAAAAAAAOA/AAAAAAAA4D8AAAAAAADgPwAAAAAAAOA/AAAAAAAA4D8CAAAAjAAAAAAAAAAAAAAAQoX0DP///wgAAAAAAAAAAAAAAAAAAAAAAAAAAAAAAAAAAAAAZAAAAAEAAABAAAAAAAAAAAAAAAAAAAAAAAAAAAAAAAAAAAAAAAAAAAAAAAAAAAAAAAAAAAAAAAAAAAAAAAAAAAAAAAAAAAAAAAAAAAAAAAAAAAAAAAAAAAAAAAAAAAAAFAAAADwAAAAAAAAAAAAAAAAAAAkUAAAAAQAAABQAAAAUAAAAFAAAAAEAAAAAAAAAZAAAAGQAAAAAAAAAZAAAAGQAAAAVAAAAYAAAAAAAAAAAAAAADwAAACADAAAAAAAAAAAAAAEAAACgMgAAVgcAAKr4//8BAAAAf39/AAEAAABkAAAAAAAAABQAAABAHwAAAAAAACYAAAAAAAAAwOD//wAAAAAmAAAAZAAAABYAAABMAAAAAAAAAAAAAAAEAAAAAAAAAAEAAABZWVkKAAAAACgAAAAoAAAAZAAAAGQAAAAAAAAAzMzMAAAAAABQAAAAUAAAAGQAAABkAAAAAAAAABcAAAAUAAAAAAAAAAAAAAD/fwAA/38AAAAAAAAJAAAABAAAAAAAAAAeAAAAaAAAAAAAAAAAAAAAAAAAAAAAAAAAAAAAECcAABAnAAAAAAAAAAAAAAAAAAAAAAAAAAAAAAAAAAAAAAAAAAAAABQAAAAAAAAAwMD/AAAAAABkAAAAMgAAAAAAAABkAAAAAAAAAH9/fwAKAAAAIgAAABgAAAAAAAAAAAAAAAAAAAAAAAAAAAAAAAAAAAAkAAAAJAAAAAAAAAAHAAAAAAAAAAAAAAAAAAAAAAAAAAAAAAAAAAAAf39/ACUAAABYAAAAAAAAAAAAAAAAAAAAAAAAAAAAAAAAAAAAAAAAAAAAAAAAAAAAAAAAAAAAAAA/AAAAAAAAAKCGAQAAAAAAAAAAAAAAAAAMAAAAAQAAAAAAAAAAAAAAAAAAAB8AAABUAAAAAAAABQAAAAEAAAAAAAAAAAAAAAAAAAAAAAAAAAAAAAAAAAAAAAAAAAAAAAJ/f38AWVlZA8zMzADAwP8Af39/AAAAAAAAAAAAAAAAAAAAAAAAAAAAIQAAABgAAAAUAAAAFAMAALMLAAB/NwAAuScAABAAAAAmAAAACAAAAAAAAAAAAAAA"/>
               </a:ext>
             </a:extLst>
           </p:cNvSpPr>
@@ -9152,7 +9152,7 @@
             <a:picLocks noChangeAspect="1"/>
             <a:extLst>
               <a:ext uri="smNativeData">
-                <pr:smNativeData xmlns:pr="smNativeData" xmlns="smNativeData" val="SMDATA_17_FUV5ZhMAAAAlAAAAEQAAAC8BAAAAkAAAAEgAAACQAAAASAAAAAAAAAAAAAAAAAAAAAEAAABQAAAAAAAAAAAA4D8AAAAAAADgPwAAAAAAAOA/AAAAAAAA4D8AAAAAAADgPwAAAAAAAOA/AAAAAAAA4D8AAAAAAADgPwAAAAAAAOA/AAAAAAAA4D8CAAAAjAAAAAAAAAAAAAAAQoX0DP///wgAAAAAAAAAAAAAAAAAAAAAAAAAAAAAAAAAAAAAZAAAAAEAAABAAAAAAAAAAAAAAAAAAAAAAAAAAAAAAAAAAAAAAAAAAAAAAAAAAAAAAAAAAAAAAAAAAAAAAAAAAAAAAAAAAAAAAAAAAAAAAAAAAAAAAAAAAAAAAAAAAAAAFAAAADwAAAAAAAAAAAAAAAAAAAkUAAAAAQAAABQAAAAUAAAAFAAAAAEAAAAAAAAAZAAAAGQAAAAAAAAAZAAAAGQAAAAVAAAAYAAAAAAAAAAAAAAADwAAACADAAAAAAAAAAAAAAEAAACgMgAAVgcAAKr4//8BAAAAf39/AAEAAABkAAAAAAAAABQAAABAHwAAAAAAACYAAAAAAAAAwOD//wAAAAAmAAAAZAAAABYAAABMAAAAAAAAAAAAAAAEAAAAAAAAAAEAAABZWVkKAAAAACgAAAAoAAAAZAAAAGQAAAAAAAAAzMzMAAAAAABQAAAAUAAAAGQAAABkAAAAAAAAAAcAAAA4AAAAAAAAAAAAAAAAAAAA////AAAAAAAAAAAAAAAAAAAAAAAAAAAAAAAAAAAAAABkAAAAZAAAAAAAAAAjAAAABAAAAGQAAAAXAAAAFAAAAAAAAAAAAAAA/38AAP9/AAAAAAAACQAAAAQAAAAAAAAAHgAAAGgAAAAAAAAAAAAAAAAAAAAAAAAAAAAAABAnAAAQJwAAAAAAAAAAAAAAAAAAAAAAAAAAAAAAAAAAAAAAAAAAAAAUAAAAAAAAAMDA/wAAAAAAZAAAADIAAAAAAAAAZAAAAAAAAAB/f38ACgAAACIAAAAYAAAAAAAAAAAAAAAAAAAAAAAAAAAAAAAAAAAAJAAAACQAAAAAAAAABwAAAAAAAAAAAAAAAAAAAAAAAAAAAAAAAAAAAH9/fwAlAAAAWAAAAAAAAAAAAAAAAAAAAAAAAAAAAAAAAAAAAAAAAAAAAAAAAAAAAAAAAAAAAAAAPwAAAAAAAACghgEAAAAAAAAAAAAAAAAADAAAAAEAAAAAAAAAAAAAAAAAAAAfAAAAVAAAAEKF9AX///8BAAAAAAAAAAAAAAAAAAAAAAAAAAAAAAAAAAAAAAAAAAAAAAACf39/AFlZWQPMzMwAwMD/AH9/fwAAAAAAAAAAAAAAAAD///8AAAAAACEAAAAYAAAAFAAAACEEAADlDgAAuS8AAKMkAAAQAAAAJgAAAAgAAAD//////////w=="/>
+                <pr:smNativeData xmlns:pr="smNativeData" xmlns="smNativeData" val="SMDATA_17_9kV5ZhMAAAAlAAAAEQAAAC8BAAAAkAAAAEgAAACQAAAASAAAAAAAAAAAAAAAAAAAAAEAAABQAAAAAAAAAAAA4D8AAAAAAADgPwAAAAAAAOA/AAAAAAAA4D8AAAAAAADgPwAAAAAAAOA/AAAAAAAA4D8AAAAAAADgPwAAAAAAAOA/AAAAAAAA4D8CAAAAjAAAAAAAAAAAAAAAQoX0DP///wgAAAAAAAAAAAAAAAAAAAAAAAAAAAAAAAAAAAAAZAAAAAEAAABAAAAAAAAAAAAAAAAAAAAAAAAAAAAAAAAAAAAAAAAAAAAAAAAAAAAAAAAAAAAAAAAAAAAAAAAAAAAAAAAAAAAAAAAAAAAAAAAAAAAAAAAAAAAAAAAAAAAAFAAAADwAAAAAAAAAAAAAAAAAAAkUAAAAAQAAABQAAAAUAAAAFAAAAAEAAAAAAAAAZAAAAGQAAAAAAAAAZAAAAGQAAAAVAAAAYAAAAAAAAAAAAAAADwAAACADAAAAAAAAAAAAAAEAAACgMgAAVgcAAKr4//8BAAAAf39/AAEAAABkAAAAAAAAABQAAABAHwAAAAAAACYAAAAAAAAAwOD//wAAAAAmAAAAZAAAABYAAABMAAAAAAAAAAAAAAAEAAAAAAAAAAEAAABZWVkKAAAAACgAAAAoAAAAZAAAAGQAAAAAAAAAzMzMAAAAAABQAAAAUAAAAGQAAABkAAAAAAAAAAcAAAA4AAAAAAAAAAAAAAAAAAAA////AAAAAAAAAAAAAAAAAAAAAAAAAAAAAAAAAAAAAABkAAAAZAAAAAAAAAAjAAAABAAAAGQAAAAXAAAAFAAAAAAAAAAAAAAA/38AAP9/AAAAAAAACQAAAAQAAAAAAAAAHgAAAGgAAAAAAAAAAAAAAAAAAAAAAAAAAAAAABAnAAAQJwAAAAAAAAAAAAAAAAAAAAAAAAAAAAAAAAAAAAAAAAAAAAAUAAAAAAAAAMDA/wAAAAAAZAAAADIAAAAAAAAAZAAAAAAAAAB/f38ACgAAACIAAAAYAAAAAAAAAAAAAAAAAAAAAAAAAAAAAAAAAAAAJAAAACQAAAAAAAAABwAAAAAAAAAAAAAAAAAAAAAAAAAAAAAAAAAAAH9/fwAlAAAAWAAAAAAAAAAAAAAAAAAAAAAAAAAAAAAAAAAAAAAAAAAAAAAAAAAAAAAAAAAAAAAAPwAAAAAAAACghgEAAAAAAAAAAAAAAAAADAAAAAEAAAAAAAAAAAAAAAAAAAAfAAAAVAAAAEKF9AX///8BAAAAAAAAAAAAAAAAAAAAAAAAAAAAAAAAAAAAAAAAAAAAAAACf39/AFlZWQPMzMwAwMD/AH9/fwAAAAAAAAAAAAAAAAD///8AAAAAACEAAAAYAAAAFAAAACEEAADlDgAAuS8AAKMkAAAQAAAAJgAAAAgAAAD//////////w=="/>
               </a:ext>
             </a:extLst>
           </p:cNvPicPr>
@@ -9218,7 +9218,7 @@
             <a:spLocks noGrp="1" noChangeArrowheads="1"/>
             <a:extLst>
               <a:ext uri="smNativeData">
-                <pr:smNativeData xmlns:pr="smNativeData" xmlns="smNativeData" val="SMDATA_15_FUV5ZhMAAAAlAAAAZAAAAA0AAAAAkAAAAJAAAACQAAAAkAAAAAAAAAAAAAAAAAAAAAEAAABQAAAAAAAAAAAA4D8AAAAAAADgPwAAAAAAAOA/AAAAAAAA4D8AAAAAAADgPwAAAAAAAOA/AAAAAAAA4D8AAAAAAADgPwAAAAAAAOA/AAAAAAAA4D8CAAAAjAAAAAAAAAAAAAAAQoX0DP///wgAAAAAAAAAAAAAAAAAAAAAAAAAAAAAAAAAAAAAZAAAAAEAAABAAAAAAAAAAAAAAAAAAAAAAAAAAAAAAAAAAAAAAAAAAAAAAAAAAAAAAAAAAAAAAAAAAAAAAAAAAAAAAAAAAAAAAAAAAAAAAAAAAAAAAAAAAAAAAAAAAAAAFAAAADwAAAAAAAAAAAAAAAAAAAkUAAAAAQAAABQAAAAUAAAAFAAAAAEAAAAAAAAAZAAAAGQAAAAAAAAAZAAAAGQAAAAVAAAAYAAAAAAAAAAAAAAADwAAACADAAAAAAAAAAAAAAEAAACgMgAAVgcAAKr4//8BAAAAf39/AAEAAABkAAAAAAAAABQAAABAHwAAAAAAACYAAAAAAAAAwOD//wAAAAAmAAAAZAAAABYAAABMAAAAAAAAAAAAAAAEAAAAAAAAAAEAAABZWVkKAAAAACgAAAAoAAAAZAAAAGQAAAAAAAAAzMzMAAAAAABQAAAAUAAAAGQAAABkAAAAAAAAABcAAAAUAAAAAAAAAAAAAAD/fwAA/38AAAAAAAAJAAAABAAAAAAAAAAeAAAAaAAAAAAAAAAAAAAAAAAAAAAAAAAAAAAAECcAABAnAAAAAAAAAAAAAAAAAAAAAAAAAAAAAAAAAAAAAAAAAAAAABQAAAAAAAAAwMD/AAAAAABkAAAAMgAAAAAAAABkAAAAAAAAAH9/fwAKAAAAIgAAABgAAAAAAAAAAAAAAAAAAAAAAAAAAAAAAAAAAAAkAAAAJAAAAAAAAAAHAAAAAAAAAAAAAAAAAAAAAAAAAAAAAAAAAAAAf39/ACUAAABYAAAAAAAAAAAAAAAAAAAAAAAAAAAAAAAAAAAAAAAAAAAAAAAAAAAAAAAAAAAAAAA/AAAAAAAAAKCGAQAAAAAAAAAAAAAAAAAMAAAAAQAAAAAAAAAAAAAAAAAAAB8AAABUAAAAAAAABQAAAAEAAAAAAAAAAAAAAAAAAAAAAAAAAAAAAAAAAAAAAAAAAAAAAAJ/f38AWVlZA8zMzADAwP8Af39/AAAAAAAAAAAAAAAAAAAAAAAAAAAAIQAAABgAAAAUAAAAFAMAALYCAAB/NwAAvwoAABAAAAAmAAAACAAAAAAAAAAAAAAA"/>
+                <pr:smNativeData xmlns:pr="smNativeData" xmlns="smNativeData" val="SMDATA_15_9kV5ZhMAAAAlAAAAZAAAAA0AAAAAkAAAAJAAAACQAAAAkAAAAAAAAAAAAAAAAAAAAAEAAABQAAAAAAAAAAAA4D8AAAAAAADgPwAAAAAAAOA/AAAAAAAA4D8AAAAAAADgPwAAAAAAAOA/AAAAAAAA4D8AAAAAAADgPwAAAAAAAOA/AAAAAAAA4D8CAAAAjAAAAAAAAAAAAAAAQoX0DP///wgAAAAAAAAAAAAAAAAAAAAAAAAAAAAAAAAAAAAAZAAAAAEAAABAAAAAAAAAAAAAAAAAAAAAAAAAAAAAAAAAAAAAAAAAAAAAAAAAAAAAAAAAAAAAAAAAAAAAAAAAAAAAAAAAAAAAAAAAAAAAAAAAAAAAAAAAAAAAAAAAAAAAFAAAADwAAAAAAAAAAAAAAAAAAAkUAAAAAQAAABQAAAAUAAAAFAAAAAEAAAAAAAAAZAAAAGQAAAAAAAAAZAAAAGQAAAAVAAAAYAAAAAAAAAAAAAAADwAAACADAAAAAAAAAAAAAAEAAACgMgAAVgcAAKr4//8BAAAAf39/AAEAAABkAAAAAAAAABQAAABAHwAAAAAAACYAAAAAAAAAwOD//wAAAAAmAAAAZAAAABYAAABMAAAAAAAAAAAAAAAEAAAAAAAAAAEAAABZWVkKAAAAACgAAAAoAAAAZAAAAGQAAAAAAAAAzMzMAAAAAABQAAAAUAAAAGQAAABkAAAAAAAAABcAAAAUAAAAAAAAAAAAAAD/fwAA/38AAAAAAAAJAAAABAAAAAAAAAAeAAAAaAAAAAAAAAAAAAAAAAAAAAAAAAAAAAAAECcAABAnAAAAAAAAAAAAAAAAAAAAAAAAAAAAAAAAAAAAAAAAAAAAABQAAAAAAAAAwMD/AAAAAABkAAAAMgAAAAAAAABkAAAAAAAAAH9/fwAKAAAAIgAAABgAAAAAAAAAAAAAAAAAAAAAAAAAAAAAAAAAAAAkAAAAJAAAAAAAAAAHAAAAAAAAAAAAAAAAAAAAAAAAAAAAAAAAAAAAf39/ACUAAABYAAAAAAAAAAAAAAAAAAAAAAAAAAAAAAAAAAAAAAAAAAAAAAAAAAAAAAAAAAAAAAA/AAAAAAAAAKCGAQAAAAAAAAAAAAAAAAAMAAAAAQAAAAAAAAAAAAAAAAAAAB8AAABUAAAAQoX0Bf///wEAAAAAAAAAAAAAAAAAAAAAAAAAAAAAAAAAAAAAAAAAAAAAAAJ/f38AWVlZA8zMzADAwP8Af39/AAAAAAAAAAAAAAAAAAAAAAAAAAAAIQAAABgAAAAUAAAAFAMAALYCAAB/NwAAvwoAABAAAAAmAAAACAAAAAAAAAAAAAAA"/>
               </a:ext>
             </a:extLst>
           </p:cNvSpPr>
@@ -9245,7 +9245,7 @@
             <a:spLocks noGrp="1" noChangeArrowheads="1"/>
             <a:extLst>
               <a:ext uri="smNativeData">
-                <pr:smNativeData xmlns:pr="smNativeData" xmlns="smNativeData" val="SMDATA_15_FUV5ZhMAAAAlAAAAZAAAAA0AAAAAkAAAAJAAAACQAAAAkAAAAAAAAAAAAAAAAAAAAAEAAABQAAAAAAAAAAAA4D8AAAAAAADgPwAAAAAAAOA/AAAAAAAA4D8AAAAAAADgPwAAAAAAAOA/AAAAAAAA4D8AAAAAAADgPwAAAAAAAOA/AAAAAAAA4D8CAAAAjAAAAAAAAAAAAAAAQoX0DP///wgAAAAAAAAAAAAAAAAAAAAAAAAAAAAAAAAAAAAAZAAAAAEAAABAAAAAAAAAAAAAAAAAAAAAAAAAAAAAAAAAAAAAAAAAAAAAAAAAAAAAAAAAAAAAAAAAAAAAAAAAAAAAAAAAAAAAAAAAAAAAAAAAAAAAAAAAAAAAAAAAAAAAFAAAADwAAAAAAAAAAAAAAAAAAAkUAAAAAQAAABQAAAAUAAAAFAAAAAEAAAAAAAAAZAAAAGQAAAAAAAAAZAAAAGQAAAAVAAAAYAAAAAAAAAAAAAAADwAAACADAAAAAAAAAAAAAAEAAACgMgAAVgcAAKr4//8BAAAAf39/AAEAAABkAAAAAAAAABQAAABAHwAAAAAAACYAAAAAAAAAwOD//wAAAAAmAAAAZAAAABYAAABMAAAAAAAAAAAAAAAEAAAAAAAAAAEAAABZWVkKAAAAACgAAAAoAAAAZAAAAGQAAAAAAAAAzMzMAAAAAABQAAAAUAAAAGQAAABkAAAAAAAAABcAAAAUAAAAAAAAAAAAAAD/fwAA/38AAAAAAAAJAAAABAAAAAAAAAAeAAAAaAAAAAAAAAAAAAAAAAAAAAAAAAAAAAAAECcAABAnAAAAAAAAAAAAAAAAAAAAAAAAAAAAAAAAAAAAAAAAAAAAABQAAAAAAAAAwMD/AAAAAABkAAAAMgAAAAAAAABkAAAAAAAAAH9/fwAKAAAAIgAAABgAAAAAAAAAAAAAAAAAAAAAAAAAAAAAAAAAAAAkAAAAJAAAAAAAAAAHAAAAAAAAAAAAAAAAAAAAAAAAAAAAAAAAAAAAf39/ACUAAABYAAAAAAAAAAAAAAAAAAAAAAAAAAAAAAAAAAAAAAAAAAAAAAAAAAAAAAAAAAAAAAA/AAAAAAAAAKCGAQAAAAAAAAAAAAAAAAAMAAAAAQAAAAAAAAAAAAAAAAAAAB8AAABUAAAAAAAABQAAAAEAAAAAAAAAAAAAAAAAAAAAAAAAAAAAAAAAAAAAAAAAAAAAAAJ/f38AWVlZA8zMzADAwP8Af39/AAAAAAAAAAAAAAAAAAAAAAAAAAAAIQAAABgAAAAUAAAAFAMAALMLAAB/NwAAuScAABAAAAAmAAAACAAAAAAAAAAAAAAA"/>
+                <pr:smNativeData xmlns:pr="smNativeData" xmlns="smNativeData" val="SMDATA_15_9kV5ZhMAAAAlAAAAZAAAAA0AAAAAkAAAAJAAAACQAAAAkAAAAAAAAAAAAAAAAAAAAAEAAABQAAAAAAAAAAAA4D8AAAAAAADgPwAAAAAAAOA/AAAAAAAA4D8AAAAAAADgPwAAAAAAAOA/AAAAAAAA4D8AAAAAAADgPwAAAAAAAOA/AAAAAAAA4D8CAAAAjAAAAAAAAAAAAAAAQoX0DP///wgAAAAAAAAAAAAAAAAAAAAAAAAAAAAAAAAAAAAAZAAAAAEAAABAAAAAAAAAAAAAAAAAAAAAAAAAAAAAAAAAAAAAAAAAAAAAAAAAAAAAAAAAAAAAAAAAAAAAAAAAAAAAAAAAAAAAAAAAAAAAAAAAAAAAAAAAAAAAAAAAAAAAFAAAADwAAAAAAAAAAAAAAAAAAAkUAAAAAQAAABQAAAAUAAAAFAAAAAEAAAAAAAAAZAAAAGQAAAAAAAAAZAAAAGQAAAAVAAAAYAAAAAAAAAAAAAAADwAAACADAAAAAAAAAAAAAAEAAACgMgAAVgcAAKr4//8BAAAAf39/AAEAAABkAAAAAAAAABQAAABAHwAAAAAAACYAAAAAAAAAwOD//wAAAAAmAAAAZAAAABYAAABMAAAAAAAAAAAAAAAEAAAAAAAAAAEAAABZWVkKAAAAACgAAAAoAAAAZAAAAGQAAAAAAAAAzMzMAAAAAABQAAAAUAAAAGQAAABkAAAAAAAAABcAAAAUAAAAAAAAAAAAAAD/fwAA/38AAAAAAAAJAAAABAAAAAAAAAAeAAAAaAAAAAAAAAAAAAAAAAAAAAAAAAAAAAAAECcAABAnAAAAAAAAAAAAAAAAAAAAAAAAAAAAAAAAAAAAAAAAAAAAABQAAAAAAAAAwMD/AAAAAABkAAAAMgAAAAAAAABkAAAAAAAAAH9/fwAKAAAAIgAAABgAAAAAAAAAAAAAAAAAAAAAAAAAAAAAAAAAAAAkAAAAJAAAAAAAAAAHAAAAAAAAAAAAAAAAAAAAAAAAAAAAAAAAAAAAf39/ACUAAABYAAAAAAAAAAAAAAAAAAAAAAAAAAAAAAAAAAAAAAAAAAAAAAAAAAAAAAAAAAAAAAA/AAAAAAAAAKCGAQAAAAAAAAAAAAAAAAAMAAAAAQAAAAAAAAAAAAAAAAAAAB8AAABUAAAAQoX0Bf///wEAAAAAAAAAAAAAAAAAAAAAAAAAAAAAAAAAAAAAAAAAAAAAAAJ/f38AWVlZA8zMzADAwP8Af39/AAAAAAAAAAAAAAAAAAAAAAAAAAAAIQAAABgAAAAUAAAAFAMAALMLAAB/NwAAuScAABAAAAAmAAAACAAAAAAAAAAAAAAA"/>
               </a:ext>
             </a:extLst>
           </p:cNvSpPr>
@@ -9278,7 +9278,7 @@
             <a:picLocks noChangeAspect="1"/>
             <a:extLst>
               <a:ext uri="smNativeData">
-                <pr:smNativeData xmlns:pr="smNativeData" xmlns="smNativeData" val="SMDATA_17_FUV5ZhMAAAAlAAAAEQAAAC8BAAAAkAAAAEgAAACQAAAASAAAAAAAAAAAAAAAAAAAAAEAAABQAAAAAAAAAAAA4D8AAAAAAADgPwAAAAAAAOA/AAAAAAAA4D8AAAAAAADgPwAAAAAAAOA/AAAAAAAA4D8AAAAAAADgPwAAAAAAAOA/AAAAAAAA4D8CAAAAjAAAAAAAAAAAAAAAQoX0DP///wgAAAAAAAAAAAAAAAAAAAAAAAAAAAAAAAAAAAAAZAAAAAEAAABAAAAAAAAAAAAAAAAAAAAAAAAAAAAAAAAAAAAAAAAAAAAAAAAAAAAAAAAAAAAAAAAAAAAAAAAAAAAAAAAAAAAAAAAAAAAAAAAAAAAAAAAAAAAAAAAAAAAAFAAAADwAAAAAAAAAAAAAAAAAAAkUAAAAAQAAABQAAAAUAAAAFAAAAAEAAAAAAAAAZAAAAGQAAAAAAAAAZAAAAGQAAAAVAAAAYAAAAAAAAAAAAAAADwAAACADAAAAAAAAAAAAAAEAAACgMgAAVgcAAKr4//8BAAAAf39/AAEAAABkAAAAAAAAABQAAABAHwAAAAAAACYAAAAAAAAAwOD//wAAAAAmAAAAZAAAABYAAABMAAAAAAAAAAAAAAAEAAAAAAAAAAEAAABZWVkKAAAAACgAAAAoAAAAZAAAAGQAAAAAAAAAzMzMAAAAAABQAAAAUAAAAGQAAABkAAAAAAAAAAcAAAA4AAAAAAAAAAAAAAAAAAAA////AAAAAAAAAAAAAAAAAAAAAAAAAAAAAAAAAAAAAABkAAAAZAAAAAAAAAAjAAAABAAAAGQAAAAXAAAAFAAAAAAAAAAAAAAA/38AAP9/AAAAAAAACQAAAAQAAAAAAAAAHgAAAGgAAAAAAAAAAAAAAAAAAAAAAAAAAAAAABAnAAAQJwAAAAAAAAAAAAAAAAAAAAAAAAAAAAAAAAAAAAAAAAAAAAAUAAAAAAAAAMDA/wAAAAAAZAAAADIAAAAAAAAAZAAAAAAAAAB/f38ACgAAACIAAAAYAAAAAAAAAAAAAAAAAAAAAAAAAAAAAAAAAAAAJAAAACQAAAAAAAAABwAAAAAAAAAAAAAAAAAAAAAAAAAAAAAAAAAAAH9/fwAlAAAAWAAAAAAAAAAAAAAAAAAAAAAAAAAAAAAAAAAAAAAAAAAAAAAAAAAAAAAAAAAAAAAAPwAAAAAAAACghgEAAAAAAAAAAAAAAAAADAAAAAEAAAAAAAAAAAAAAAAAAAAfAAAAVAAAAEKF9AX///8BAAAAAAAAAAAAAAAAAAAAAAAAAAAAAAAAAAAAAAAAAAAAAAACf39/AFlZWQPMzMwAwMD/AH9/fwAAAAAAAAAAAAAAAAD///8AAAAAACEAAAAYAAAAFAAAAKADAACZDgAAIiMAAKUnAAAQAAAAJgAAAAgAAAD//////////w=="/>
+                <pr:smNativeData xmlns:pr="smNativeData" xmlns="smNativeData" val="SMDATA_17_9kV5ZhMAAAAlAAAAEQAAAC8BAAAAkAAAAEgAAACQAAAASAAAAAAAAAAAAAAAAAAAAAEAAABQAAAAAAAAAAAA4D8AAAAAAADgPwAAAAAAAOA/AAAAAAAA4D8AAAAAAADgPwAAAAAAAOA/AAAAAAAA4D8AAAAAAADgPwAAAAAAAOA/AAAAAAAA4D8CAAAAjAAAAAAAAAAAAAAAQoX0DP///wgAAAAAAAAAAAAAAAAAAAAAAAAAAAAAAAAAAAAAZAAAAAEAAABAAAAAAAAAAAAAAAAAAAAAAAAAAAAAAAAAAAAAAAAAAAAAAAAAAAAAAAAAAAAAAAAAAAAAAAAAAAAAAAAAAAAAAAAAAAAAAAAAAAAAAAAAAAAAAAAAAAAAFAAAADwAAAAAAAAAAAAAAAAAAAkUAAAAAQAAABQAAAAUAAAAFAAAAAEAAAAAAAAAZAAAAGQAAAAAAAAAZAAAAGQAAAAVAAAAYAAAAAAAAAAAAAAADwAAACADAAAAAAAAAAAAAAEAAACgMgAAVgcAAKr4//8BAAAAf39/AAEAAABkAAAAAAAAABQAAABAHwAAAAAAACYAAAAAAAAAwOD//wAAAAAmAAAAZAAAABYAAABMAAAAAAAAAAAAAAAEAAAAAAAAAAEAAABZWVkKAAAAACgAAAAoAAAAZAAAAGQAAAAAAAAAzMzMAAAAAABQAAAAUAAAAGQAAABkAAAAAAAAAAcAAAA4AAAAAAAAAAAAAAAAAAAA////AAAAAAAAAAAAAAAAAAAAAAAAAAAAAAAAAAAAAABkAAAAZAAAAAAAAAAjAAAABAAAAGQAAAAXAAAAFAAAAAAAAAAAAAAA/38AAP9/AAAAAAAACQAAAAQAAAAAAAAAHgAAAGgAAAAAAAAAAAAAAAAAAAAAAAAAAAAAABAnAAAQJwAAAAAAAAAAAAAAAAAAAAAAAAAAAAAAAAAAAAAAAAAAAAAUAAAAAAAAAMDA/wAAAAAAZAAAADIAAAAAAAAAZAAAAAAAAAB/f38ACgAAACIAAAAYAAAAAAAAAAAAAAAAAAAAAAAAAAAAAAAAAAAAJAAAACQAAAAAAAAABwAAAAAAAAAAAAAAAAAAAAAAAAAAAAAAAAAAAH9/fwAlAAAAWAAAAAAAAAAAAAAAAAAAAAAAAAAAAAAAAAAAAAAAAAAAAAAAAAAAAAAAAAAAAAAAPwAAAAAAAACghgEAAAAAAAAAAAAAAAAADAAAAAEAAAAAAAAAAAAAAAAAAAAfAAAAVAAAAEKF9AX///8BAAAAAAAAAAAAAAAAAAAAAAAAAAAAAAAAAAAAAAAAAAAAAAACf39/AFlZWQPMzMwAwMD/AH9/fwAAAAAAAAAAAAAAAAD///8AAAAAACEAAAAYAAAAFAAAAKADAACZDgAAIiMAAKUnAAAQAAAAJgAAAAgAAAD//////////w=="/>
               </a:ext>
             </a:extLst>
           </p:cNvPicPr>
@@ -9344,7 +9344,7 @@
             <a:spLocks noGrp="1" noChangeArrowheads="1"/>
             <a:extLst>
               <a:ext uri="smNativeData">
-                <pr:smNativeData xmlns:pr="smNativeData" xmlns="smNativeData" val="SMDATA_15_FUV5ZhMAAAAlAAAAZAAAAA0AAAAAkAAAAJAAAACQAAAAkAAAAAAAAAAAAAAAAAAAAAEAAABQAAAAAAAAAAAA4D8AAAAAAADgPwAAAAAAAOA/AAAAAAAA4D8AAAAAAADgPwAAAAAAAOA/AAAAAAAA4D8AAAAAAADgPwAAAAAAAOA/AAAAAAAA4D8CAAAAjAAAAAAAAAAAAAAAQoX0DP///wgAAAAAAAAAAAAAAAAAAAAAAAAAAAAAAAAAAAAAZAAAAAEAAABAAAAAAAAAAAAAAAAAAAAAAAAAAAAAAAAAAAAAAAAAAAAAAAAAAAAAAAAAAAAAAAAAAAAAAAAAAAAAAAAAAAAAAAAAAAAAAAAAAAAAAAAAAAAAAAAAAAAAFAAAADwAAAAAAAAAAAAAAAAAAAkUAAAAAQAAABQAAAAUAAAAFAAAAAEAAAAAAAAAZAAAAGQAAAAAAAAAZAAAAGQAAAAVAAAAYAAAAAAAAAAAAAAADwAAACADAAAAAAAAAAAAAAEAAACgMgAAVgcAAKr4//8BAAAAf39/AAEAAABkAAAAAAAAABQAAABAHwAAAAAAACYAAAAAAAAAwOD//wAAAAAmAAAAZAAAABYAAABMAAAAAAAAAAAAAAAEAAAAAAAAAAEAAABZWVkKAAAAACgAAAAoAAAAZAAAAGQAAAAAAAAAzMzMAAAAAABQAAAAUAAAAGQAAABkAAAAAAAAABcAAAAUAAAAAAAAAAAAAAD/fwAA/38AAAAAAAAJAAAABAAAAAAAAAAeAAAAaAAAAAAAAAAAAAAAAAAAAAAAAAAAAAAAECcAABAnAAAAAAAAAAAAAAAAAAAAAAAAAAAAAAAAAAAAAAAAAAAAABQAAAAAAAAAwMD/AAAAAABkAAAAMgAAAAAAAABkAAAAAAAAAH9/fwAKAAAAIgAAABgAAAAAAAAAAAAAAAAAAAAAAAAAAAAAAAAAAAAkAAAAJAAAAAAAAAAHAAAAAAAAAAAAAAAAAAAAAAAAAAAAAAAAAAAAf39/ACUAAABYAAAAAAAAAAAAAAAAAAAAAAAAAAAAAAAAAAAAAAAAAAAAAAAAAAAAAAAAAAAAAAA/AAAAAAAAAKCGAQAAAAAAAAAAAAAAAAAMAAAAAQAAAAAAAAAAAAAAAAAAAB8AAABUAAAAAAAABQAAAAEAAAAAAAAAAAAAAAAAAAAAAAAAAAAAAAAAAAAAAAAAAAAAAAJ/f38AWVlZA8zMzADAwP8Af39/AAAAAAAAAAAAAAAAAAAAAAAAAAAAIQAAABgAAAAUAAAAFAMAALYCAAB/NwAAvwoAABAAAAAmAAAACAAAAAAAAAAAAAAA"/>
+                <pr:smNativeData xmlns:pr="smNativeData" xmlns="smNativeData" val="SMDATA_15_9kV5ZhMAAAAlAAAAZAAAAA0AAAAAkAAAAJAAAACQAAAAkAAAAAAAAAAAAAAAAAAAAAEAAABQAAAAAAAAAAAA4D8AAAAAAADgPwAAAAAAAOA/AAAAAAAA4D8AAAAAAADgPwAAAAAAAOA/AAAAAAAA4D8AAAAAAADgPwAAAAAAAOA/AAAAAAAA4D8CAAAAjAAAAAAAAAAAAAAAQoX0DP///wgAAAAAAAAAAAAAAAAAAAAAAAAAAAAAAAAAAAAAZAAAAAEAAABAAAAAAAAAAAAAAAAAAAAAAAAAAAAAAAAAAAAAAAAAAAAAAAAAAAAAAAAAAAAAAAAAAAAAAAAAAAAAAAAAAAAAAAAAAAAAAAAAAAAAAAAAAAAAAAAAAAAAFAAAADwAAAAAAAAAAAAAAAAAAAkUAAAAAQAAABQAAAAUAAAAFAAAAAEAAAAAAAAAZAAAAGQAAAAAAAAAZAAAAGQAAAAVAAAAYAAAAAAAAAAAAAAADwAAACADAAAAAAAAAAAAAAEAAACgMgAAVgcAAKr4//8BAAAAf39/AAEAAABkAAAAAAAAABQAAABAHwAAAAAAACYAAAAAAAAAwOD//wAAAAAmAAAAZAAAABYAAABMAAAAAAAAAAAAAAAEAAAAAAAAAAEAAABZWVkKAAAAACgAAAAoAAAAZAAAAGQAAAAAAAAAzMzMAAAAAABQAAAAUAAAAGQAAABkAAAAAAAAABcAAAAUAAAAAAAAAAAAAAD/fwAA/38AAAAAAAAJAAAABAAAAAAAAAAeAAAAaAAAAAAAAAAAAAAAAAAAAAAAAAAAAAAAECcAABAnAAAAAAAAAAAAAAAAAAAAAAAAAAAAAAAAAAAAAAAAAAAAABQAAAAAAAAAwMD/AAAAAABkAAAAMgAAAAAAAABkAAAAAAAAAH9/fwAKAAAAIgAAABgAAAAAAAAAAAAAAAAAAAAAAAAAAAAAAAAAAAAkAAAAJAAAAAAAAAAHAAAAAAAAAAAAAAAAAAAAAAAAAAAAAAAAAAAAf39/ACUAAABYAAAAAAAAAAAAAAAAAAAAAAAAAAAAAAAAAAAAAAAAAAAAAAAAAAAAAAAAAAAAAAA/AAAAAAAAAKCGAQAAAAAAAAAAAAAAAAAMAAAAAQAAAAAAAAAAAAAAAAAAAB8AAABUAAAAQoX0Bf///wEAAAAAAAAAAAAAAAAAAAAAAAAAAAAAAAAAAAAAAAAAAAAAAAJ/f38AWVlZA8zMzADAwP8Af39/AAAAAAAAAAAAAAAAAAAAAAAAAAAAIQAAABgAAAAUAAAAFAMAALYCAAB/NwAAvwoAABAAAAAmAAAACAAAAAAAAAAAAAAA"/>
               </a:ext>
             </a:extLst>
           </p:cNvSpPr>
@@ -9371,7 +9371,7 @@
             <a:spLocks noGrp="1" noChangeArrowheads="1"/>
             <a:extLst>
               <a:ext uri="smNativeData">
-                <pr:smNativeData xmlns:pr="smNativeData" xmlns="smNativeData" val="SMDATA_15_FUV5ZhMAAAAlAAAAZAAAAA0AAAAAkAAAAJAAAACQAAAAkAAAAAAAAAAAAAAAAAAAAAEAAABQAAAAAAAAAAAA4D8AAAAAAADgPwAAAAAAAOA/AAAAAAAA4D8AAAAAAADgPwAAAAAAAOA/AAAAAAAA4D8AAAAAAADgPwAAAAAAAOA/AAAAAAAA4D8CAAAAjAAAAAAAAAAAAAAAQoX0DP///wgAAAAAAAAAAAAAAAAAAAAAAAAAAAAAAAAAAAAAZAAAAAEAAABAAAAAAAAAAAAAAAAAAAAAAAAAAAAAAAAAAAAAAAAAAAAAAAAAAAAAAAAAAAAAAAAAAAAAAAAAAAAAAAAAAAAAAAAAAAAAAAAAAAAAAAAAAAAAAAAAAAAAFAAAADwAAAAAAAAAAAAAAAAAAAkUAAAAAQAAABQAAAAUAAAAFAAAAAEAAAAAAAAAZAAAAGQAAAAAAAAAZAAAAGQAAAAVAAAAYAAAAAAAAAAAAAAADwAAACADAAAAAAAAAAAAAAEAAACgMgAAVgcAAKr4//8BAAAAf39/AAEAAABkAAAAAAAAABQAAABAHwAAAAAAACYAAAAAAAAAwOD//wAAAAAmAAAAZAAAABYAAABMAAAAAAAAAAAAAAAEAAAAAAAAAAEAAABZWVkKAAAAACgAAAAoAAAAZAAAAGQAAAAAAAAAzMzMAAAAAABQAAAAUAAAAGQAAABkAAAAAAAAABcAAAAUAAAAAAAAAAAAAAD/fwAA/38AAAAAAAAJAAAABAAAAAAAAAAeAAAAaAAAAAAAAAAAAAAAAAAAAAAAAAAAAAAAECcAABAnAAAAAAAAAAAAAAAAAAAAAAAAAAAAAAAAAAAAAAAAAAAAABQAAAAAAAAAwMD/AAAAAABkAAAAMgAAAAAAAABkAAAAAAAAAH9/fwAKAAAAIgAAABgAAAAAAAAAAAAAAAAAAAAAAAAAAAAAAAAAAAAkAAAAJAAAAAAAAAAHAAAAAAAAAAAAAAAAAAAAAAAAAAAAAAAAAAAAf39/ACUAAABYAAAAAAAAAAAAAAAAAAAAAAAAAAAAAAAAAAAAAAAAAAAAAAAAAAAAAAAAAAAAAAA/AAAAAAAAAKCGAQAAAAAAAAAAAAAAAAAMAAAAAQAAAAAAAAAAAAAAAAAAAB8AAABUAAAAAAAABQAAAAEAAAAAAAAAAAAAAAAAAAAAAAAAAAAAAAAAAAAAAAAAAAAAAAJ/f38AWVlZA8zMzADAwP8Af39/AAAAAAAAAAAAAAAAAAAAAAAAAAAAIQAAABgAAAAUAAAAFAMAALMLAAB/NwAAuScAABAAAAAmAAAACAAAAAAAAAAAAAAA"/>
+                <pr:smNativeData xmlns:pr="smNativeData" xmlns="smNativeData" val="SMDATA_15_9kV5ZhMAAAAlAAAAZAAAAA0AAAAAkAAAAJAAAACQAAAAkAAAAAAAAAAAAAAAAAAAAAEAAABQAAAAAAAAAAAA4D8AAAAAAADgPwAAAAAAAOA/AAAAAAAA4D8AAAAAAADgPwAAAAAAAOA/AAAAAAAA4D8AAAAAAADgPwAAAAAAAOA/AAAAAAAA4D8CAAAAjAAAAAAAAAAAAAAAQoX0DP///wgAAAAAAAAAAAAAAAAAAAAAAAAAAAAAAAAAAAAAZAAAAAEAAABAAAAAAAAAAAAAAAAAAAAAAAAAAAAAAAAAAAAAAAAAAAAAAAAAAAAAAAAAAAAAAAAAAAAAAAAAAAAAAAAAAAAAAAAAAAAAAAAAAAAAAAAAAAAAAAAAAAAAFAAAADwAAAAAAAAAAAAAAAAAAAkUAAAAAQAAABQAAAAUAAAAFAAAAAEAAAAAAAAAZAAAAGQAAAAAAAAAZAAAAGQAAAAVAAAAYAAAAAAAAAAAAAAADwAAACADAAAAAAAAAAAAAAEAAACgMgAAVgcAAKr4//8BAAAAf39/AAEAAABkAAAAAAAAABQAAABAHwAAAAAAACYAAAAAAAAAwOD//wAAAAAmAAAAZAAAABYAAABMAAAAAAAAAAAAAAAEAAAAAAAAAAEAAABZWVkKAAAAACgAAAAoAAAAZAAAAGQAAAAAAAAAzMzMAAAAAABQAAAAUAAAAGQAAABkAAAAAAAAABcAAAAUAAAAAAAAAAAAAAD/fwAA/38AAAAAAAAJAAAABAAAAAAAAAAeAAAAaAAAAAAAAAAAAAAAAAAAAAAAAAAAAAAAECcAABAnAAAAAAAAAAAAAAAAAAAAAAAAAAAAAAAAAAAAAAAAAAAAABQAAAAAAAAAwMD/AAAAAABkAAAAMgAAAAAAAABkAAAAAAAAAH9/fwAKAAAAIgAAABgAAAAAAAAAAAAAAAAAAAAAAAAAAAAAAAAAAAAkAAAAJAAAAAAAAAAHAAAAAAAAAAAAAAAAAAAAAAAAAAAAAAAAAAAAf39/ACUAAABYAAAAAAAAAAAAAAAAAAAAAAAAAAAAAAAAAAAAAAAAAAAAAAAAAAAAAAAAAAAAAAA/AAAAAAAAAKCGAQAAAAAAAAAAAAAAAAAMAAAAAQAAAAAAAAAAAAAAAAAAAB8AAABUAAAAQoX0Bf///wEAAAAAAAAAAAAAAAAAAAAAAAAAAAAAAAAAAAAAAAAAAAAAAAJ/f38AWVlZA8zMzADAwP8Af39/AAAAAAAAAAAAAAAAAAAAAAAAAAAAIQAAABgAAAAUAAAAFAMAALMLAAB/NwAAuScAABAAAAAmAAAACAAAAAAAAAAAAAAA"/>
               </a:ext>
             </a:extLst>
           </p:cNvSpPr>
@@ -9448,7 +9448,7 @@
             <a:spLocks noGrp="1" noChangeArrowheads="1"/>
             <a:extLst>
               <a:ext uri="smNativeData">
-                <pr:smNativeData xmlns:pr="smNativeData" xmlns="smNativeData" val="SMDATA_15_FUV5ZhMAAAAlAAAAZAAAAA0AAAAAkAAAAJAAAACQAAAAkAAAAAAAAAAAAAAAAAAAAAEAAABQAAAAAAAAAAAA4D8AAAAAAADgPwAAAAAAAOA/AAAAAAAA4D8AAAAAAADgPwAAAAAAAOA/AAAAAAAA4D8AAAAAAADgPwAAAAAAAOA/AAAAAAAA4D8CAAAAjAAAAAAAAAAAAAAAQoX0DP///wgAAAAAAAAAAAAAAAAAAAAAAAAAAAAAAAAAAAAAZAAAAAEAAABAAAAAAAAAAAAAAAAAAAAAAAAAAAAAAAAAAAAAAAAAAAAAAAAAAAAAAAAAAAAAAAAAAAAAAAAAAAAAAAAAAAAAAAAAAAAAAAAAAAAAAAAAAAAAAAAAAAAAFAAAADwAAAAAAAAAAAAAAAAAAAkUAAAAAQAAABQAAAAUAAAAFAAAAAEAAAAAAAAAZAAAAGQAAAAAAAAAZAAAAGQAAAAVAAAAYAAAAAAAAAAAAAAADwAAACADAAAAAAAAAAAAAAEAAACgMgAAVgcAAKr4//8BAAAAf39/AAEAAABkAAAAAAAAABQAAABAHwAAAAAAACYAAAAAAAAAwOD//wAAAAAmAAAAZAAAABYAAABMAAAAAAAAAAAAAAAEAAAAAAAAAAEAAABZWVkKAAAAACgAAAAoAAAAZAAAAGQAAAAAAAAAzMzMAAAAAABQAAAAUAAAAGQAAABkAAAAAAAAABcAAAAUAAAAAAAAAAAAAAD/fwAA/38AAAAAAAAJAAAABAAAADtUGRUeAAAAaAAAAAAAAAAAAAAAAAAAAAAAAAAAAAAAECcAABAnAAAAAAAAAAAAAAAAAAAAAAAAAAAAAAAAAAAAAAAAAAAAABQAAAAAAAAAwMD/AAAAAABkAAAAMgAAAAAAAABkAAAAAAAAAH9/fwAKAAAAIgAAABgAAAAAAAAAAAAAAAAAAAAAAAAAAAAAAAAAAAAkAAAAJAAAAAAAAAAHAAAAAAAAAAAAAAAAAAAAAAAAAAAAAAAAAAAAf39/ACUAAABYAAAAAAAAAAAAAAAAAAAAAAAAAAAAAAAAAAAAAAAAAAAAAAAAAAAAAAAAAAAAAAA/AAAAAAAAAKCGAQAAAAAAAAAAAAAAAAAMAAAAAQAAAAAAAAAAAAAAAAAAAB8AAABUAAAAQoX0Bf///wEAAAAAAAAAAAAAAAAAAAAAAAAAAAAAAAAAAAAAAAAAAAAAAAJ/f38AWVlZA8zMzADAwP8Af39/AAAAAAAAAAAAAAAAAAAAAAAAAAAAIQAAABgAAAAUAAAA+gIAAIICAABlNwAAiwoAABAAAAAmAAAACAAAAD0wAAAAAAAA"/>
+                <pr:smNativeData xmlns:pr="smNativeData" xmlns="smNativeData" val="SMDATA_15_9kV5ZhMAAAAlAAAAZAAAAA0AAAAAkAAAAJAAAACQAAAAkAAAAAAAAAAAAAAAAAAAAAEAAABQAAAAAAAAAAAA4D8AAAAAAADgPwAAAAAAAOA/AAAAAAAA4D8AAAAAAADgPwAAAAAAAOA/AAAAAAAA4D8AAAAAAADgPwAAAAAAAOA/AAAAAAAA4D8CAAAAjAAAAAAAAAAAAAAAQoX0DP///wgAAAAAAAAAAAAAAAAAAAAAAAAAAAAAAAAAAAAAZAAAAAEAAABAAAAAAAAAAAAAAAAAAAAAAAAAAAAAAAAAAAAAAAAAAAAAAAAAAAAAAAAAAAAAAAAAAAAAAAAAAAAAAAAAAAAAAAAAAAAAAAAAAAAAAAAAAAAAAAAAAAAAFAAAADwAAAAAAAAAAAAAAAAAAAkUAAAAAQAAABQAAAAUAAAAFAAAAAEAAAAAAAAAZAAAAGQAAAAAAAAAZAAAAGQAAAAVAAAAYAAAAAAAAAAAAAAADwAAACADAAAAAAAAAAAAAAEAAACgMgAAVgcAAKr4//8BAAAAf39/AAEAAABkAAAAAAAAABQAAABAHwAAAAAAACYAAAAAAAAAwOD//wAAAAAmAAAAZAAAABYAAABMAAAAAAAAAAAAAAAEAAAAAAAAAAEAAABZWVkKAAAAACgAAAAoAAAAZAAAAGQAAAAAAAAAzMzMAAAAAABQAAAAUAAAAGQAAABkAAAAAAAAABcAAAAUAAAAAAAAAAAAAAD/fwAA/38AAAAAAAAJAAAABAAAADtUGRUeAAAAaAAAAAAAAAAAAAAAAAAAAAAAAAAAAAAAECcAABAnAAAAAAAAAAAAAAAAAAAAAAAAAAAAAAAAAAAAAAAAAAAAABQAAAAAAAAAwMD/AAAAAABkAAAAMgAAAAAAAABkAAAAAAAAAH9/fwAKAAAAIgAAABgAAAAAAAAAAAAAAAAAAAAAAAAAAAAAAAAAAAAkAAAAJAAAAAAAAAAHAAAAAAAAAAAAAAAAAAAAAAAAAAAAAAAAAAAAf39/ACUAAABYAAAAAAAAAAAAAAAAAAAAAAAAAAAAAAAAAAAAAAAAAAAAAAAAAAAAAAAAAAAAAAA/AAAAAAAAAKCGAQAAAAAAAAAAAAAAAAAMAAAAAQAAAAAAAAAAAAAAAAAAAB8AAABUAAAAQoX0Bf///wEAAAAAAAAAAAAAAAAAAAAAAAAAAAAAAAAAAAAAAAAAAAAAAAJ/f38AWVlZA8zMzADAwP8Af39/AAAAAAAAAAAAAAAAAAAAAAAAAAAAIQAAABgAAAAUAAAA+gIAAIICAABlNwAAiwoAABAAAAAmAAAACAAAAD0wAAAAAAAA"/>
               </a:ext>
             </a:extLst>
           </p:cNvSpPr>
@@ -9515,7 +9515,7 @@
           <p:cNvSpPr>
             <a:extLst>
               <a:ext uri="smNativeData">
-                <pr:smNativeData xmlns:pr="smNativeData" xmlns="smNativeData" val="SMDATA_15_FUV5ZhMAAAAlAAAA9AEAAA0AAAAAOAEAAMYAAAA4AQAAxgAAAAAAAAABAAAAAAAAAAEAAABQAAAAtSRVET1m6b8FJ9au5qX6vwAAAAAAAOA/AAAAAAAA4D8AAAAAAADgPwAAAAAAAOA/AAAAAAAA4D8AAAAAAADgPwAAAAAAAOA/AAAAAAAA4D8CAAAAjAAAAAEAAAAAAAAA8/PzAP///wgAAAAAAAAAAAAAAAAAAAAAAAAAAAAAAAAAAAAAeAAAAAEAAABAAAAAAAAAAAAAAABaAAAAAAAAAAAAAAAAAAAAAAAAAAAAAAAAAAAAAAAAAAAAAAAAAAAAAAAAAAAAAAAAAAAAAAAAAAAAAAAAAAAAAAAAAAAAAAAAAAAAFAAAADwAAAABAAAAAAAAAAE9hQAPAAAAAQAAACMAAAAjAAAAIwAAAB4AAAAAAAAASwAAAEsAAAAAAAAASwAAAEsAAAAVAAAAYAAAAAAAAAAAAAAADwAAACADAAAAAAAAAAAAAAEAAACgMgAAVgcAAKr4//8BAAAAf39/AAEAAABkAAAAAAAAABQAAABAHwAAAAAAACYAAAAAAAAAwOD//wAAAAAmAAAAZAAAABYAAABMAAAAAAAAAAAAAAAEAAAAAAAAAAEAAABZWVkKAAAAACgAAAAoAAAAZAAAAGQAAAAAAAAAzMzMAAAAAABQAAAAUAAAAGQAAABkAAAAAAAAABcAAAAUAAAAAAAAAAAAAAD/fwAA/38AAAAAAAAJAAAABAAAAG+pTlkeAAAAaAAAAAAAAAAAAAAAAAAAAAAAAAAAAAAAECcAABAnAAAAAAAAAAAAAAAAAAAAAAAAAAAAAAAAAAAAAAAAAAAAABQAAAAAAAAAwMD/AAAAAABkAAAAMgAAAAAAAABkAAAAAAAAAH9/fwAKAAAAIgAAABgAAAAAAAAAAAAAAAAAAAAAAAAAAAAAAAAAAAAkAAAAJAAAAAAAAAAHAAAAAAAAAAAAAAAAAAAAAAAAAAAAAAAAAAAAf39/ACUAAABYAAAAAAAAAAAAAAAAAAAAAAAAAAAAAAAAAAAAAAAAAAAAAAAAAAAAAAAAAAAAAAA/AAAAAAAAAKCGAQAAAAAAAAAAAAAAAAAMAAAAAQAAAAAAAAAAAAAAAAAAAB8AAABUAAAA8/PzAP///wEAAAAAAAAAAAAAAAAAAAAAAAAAAAAAAAAAAAAAAAAAAAE9hQB/f38AWVlZA8zMzADAwP8Af39/AAAAAAAAAAAAAAAAAAAAAAAAAAAAIQAAABgAAAAUAAAAvR0AAO0fAADMMgAApCYAABAAAAAmAAAACAAAAP//////////"/>
+                <pr:smNativeData xmlns:pr="smNativeData" xmlns="smNativeData" val="SMDATA_15_9kV5ZhMAAAAlAAAA9AEAAA0AAAAAOAEAAMYAAAA4AQAAxgAAAAAAAAABAAAAAAAAAAEAAABQAAAAtSRVET1m6b8FJ9au5qX6vwAAAAAAAOA/AAAAAAAA4D8AAAAAAADgPwAAAAAAAOA/AAAAAAAA4D8AAAAAAADgPwAAAAAAAOA/AAAAAAAA4D8CAAAAjAAAAAEAAAAAAAAA8/PzAP///wgAAAAAAAAAAAAAAAAAAAAAAAAAAAAAAAAAAAAAeAAAAAEAAABAAAAAAAAAAAAAAABaAAAAAAAAAAAAAAAAAAAAAAAAAAAAAAAAAAAAAAAAAAAAAAAAAAAAAAAAAAAAAAAAAAAAAAAAAAAAAAAAAAAAAAAAAAAAAAAAAAAAFAAAADwAAAABAAAAAAAAAAE9hQAPAAAAAQAAACMAAAAjAAAAIwAAAB4AAAAAAAAASwAAAEsAAAAAAAAASwAAAEsAAAAVAAAAYAAAAAAAAAAAAAAADwAAACADAAAAAAAAAAAAAAEAAACgMgAAVgcAAKr4//8BAAAAf39/AAEAAABkAAAAAAAAABQAAABAHwAAAAAAACYAAAAAAAAAwOD//wAAAAAmAAAAZAAAABYAAABMAAAAAAAAAAAAAAAEAAAAAAAAAAEAAABZWVkKAAAAACgAAAAoAAAAZAAAAGQAAAAAAAAAzMzMAAAAAABQAAAAUAAAAGQAAABkAAAAAAAAABcAAAAUAAAAAAAAAAAAAAD/fwAA/38AAAAAAAAJAAAABAAAAG+pTlkeAAAAaAAAAAAAAAAAAAAAAAAAAAAAAAAAAAAAECcAABAnAAAAAAAAAAAAAAAAAAAAAAAAAAAAAAAAAAAAAAAAAAAAABQAAAAAAAAAwMD/AAAAAABkAAAAMgAAAAAAAABkAAAAAAAAAH9/fwAKAAAAIgAAABgAAAAAAAAAAAAAAAAAAAAAAAAAAAAAAAAAAAAkAAAAJAAAAAAAAAAHAAAAAAAAAAAAAAAAAAAAAAAAAAAAAAAAAAAAf39/ACUAAABYAAAAAAAAAAAAAAAAAAAAAAAAAAAAAAAAAAAAAAAAAAAAAAAAAAAAAAAAAAAAAAA/AAAAAAAAAKCGAQAAAAAAAAAAAAAAAAAMAAAAAQAAAAAAAAAAAAAAAAAAAB8AAABUAAAA8/PzAP///wEAAAAAAAAAAAAAAAAAAAAAAAAAAAAAAAAAAAAAAAAAAAE9hQB/f38AWVlZA8zMzADAwP8Af39/AAAAAAAAAAAAAAAAAAAAAAAAAAAAIQAAABgAAAAUAAAAvR0AAO0fAADMMgAApCYAABAAAAAmAAAACAAAAP//////////"/>
               </a:ext>
             </a:extLst>
           </p:cNvSpPr>
@@ -9587,7 +9587,7 @@
             <a:picLocks noChangeAspect="1"/>
             <a:extLst>
               <a:ext uri="smNativeData">
-                <pr:smNativeData xmlns:pr="smNativeData" xmlns="smNativeData" val="SMDATA_17_FUV5ZhMAAAAlAAAAEQAAAC8BAAAAkAAAAEgAAACQAAAASAAAAAAAAAAAAAAAAAAAAAEAAABQAAAAAAAAAAAA4D8AAAAAAADgPwAAAAAAAOA/AAAAAAAA4D8AAAAAAADgPwAAAAAAAOA/AAAAAAAA4D8AAAAAAADgPwAAAAAAAOA/AAAAAAAA4D8CAAAAjAAAAAAAAAAAAAAAQoX0DP///wgAAAAAAAAAAAAAAAAAAAAAAAAAAAAAAAAAAAAAZAAAAAEAAABAAAAAAAAAAAAAAAAAAAAAAAAAAAAAAAAAAAAAAAAAAAAAAAAAAAAAAAAAAAAAAAAAAAAAAAAAAAAAAAAAAAAAAAAAAAAAAAAAAAAAAAAAAAAAAAAAAAAAFAAAADwAAAAAAAAAAAAAAAAAAAkUAAAAAQAAABQAAAAUAAAAFAAAAAEAAAAAAAAAZAAAAGQAAAAAAAAAZAAAAGQAAAAVAAAAYAAAAAAAAAAAAAAADwAAACADAAAAAAAAAAAAAAEAAACgMgAAVgcAAKr4//8BAAAAf39/AAEAAABkAAAAAAAAABQAAABAHwAAAAAAACYAAAAAAAAAwOD//wAAAAAmAAAAZAAAABYAAABMAAAAAAAAAAAAAAAEAAAAAAAAAAEAAABZWVkKAAAAACgAAAAoAAAAZAAAAGQAAAAAAAAAzMzMAAAAAABQAAAAUAAAAGQAAABkAAAAAAAAAAcAAAA4AAAAAAAAAAAAAAAAAAAA////AAAAAAAAAAAAAAAAAAAAAAAAAAAAAAAAAAAAAABkAAAAZAAAAAAAAAAjAAAABAAAAGQAAAAXAAAAFAAAAAAAAAAAAAAA/38AAP9/AAAAAAAACQAAAAQAAAAOAAAAHgAAAGgAAAAAAAAAAAAAAAAAAAAAAAAAAAAAABAnAAAQJwAAAAAAAAAAAAAAAAAAAAAAAAAAAAAAAAAAAAAAAAAAAAAUAAAAAAAAAMDA/wAAAAAAZAAAADIAAAAAAAAAZAAAAAAAAAB/f38ACgAAACIAAAAYAAAAAAAAAAAAAAAAAAAAAAAAAAAAAAAAAAAAJAAAACQAAAAAAAAABwAAAAAAAAAAAAAAAAAAAAAAAAAAAAAAAAAAAH9/fwAlAAAAWAAAAAAAAAAAAAAAAAAAAAAAAAAAAAAAAAAAAAAAAAAAAAAAAAAAAAAAAAAAAAAAPwAAAAAAAACghgEAAAAAAAAAAAAAAAAADAAAAAEAAAAAAAAAAAAAAAAAAAAfAAAAVAAAAEKF9AX///8BAAAAAAAAAAAAAAAAAAAAAAAAAAAAAAAAAAAAAAAAAAAAAAACf39/AFlZWQPMzMwAwMD/AH9/fwAAAAAAAAAAAAAAAAD///8AAAAAACEAAAAYAAAAFAAAAAUDAAB5CwAAQzcAAMkcAAAQAAAAJgAAAAgAAAD//////////w=="/>
+                <pr:smNativeData xmlns:pr="smNativeData" xmlns="smNativeData" val="SMDATA_17_9kV5ZhMAAAAlAAAAEQAAAC8BAAAAkAAAAEgAAACQAAAASAAAAAAAAAAAAAAAAAAAAAEAAABQAAAAAAAAAAAA4D8AAAAAAADgPwAAAAAAAOA/AAAAAAAA4D8AAAAAAADgPwAAAAAAAOA/AAAAAAAA4D8AAAAAAADgPwAAAAAAAOA/AAAAAAAA4D8CAAAAjAAAAAAAAAAAAAAAQoX0DP///wgAAAAAAAAAAAAAAAAAAAAAAAAAAAAAAAAAAAAAZAAAAAEAAABAAAAAAAAAAAAAAAAAAAAAAAAAAAAAAAAAAAAAAAAAAAAAAAAAAAAAAAAAAAAAAAAAAAAAAAAAAAAAAAAAAAAAAAAAAAAAAAAAAAAAAAAAAAAAAAAAAAAAFAAAADwAAAAAAAAAAAAAAAAAAAkUAAAAAQAAABQAAAAUAAAAFAAAAAEAAAAAAAAAZAAAAGQAAAAAAAAAZAAAAGQAAAAVAAAAYAAAAAAAAAAAAAAADwAAACADAAAAAAAAAAAAAAEAAACgMgAAVgcAAKr4//8BAAAAf39/AAEAAABkAAAAAAAAABQAAABAHwAAAAAAACYAAAAAAAAAwOD//wAAAAAmAAAAZAAAABYAAABMAAAAAAAAAAAAAAAEAAAAAAAAAAEAAABZWVkKAAAAACgAAAAoAAAAZAAAAGQAAAAAAAAAzMzMAAAAAABQAAAAUAAAAGQAAABkAAAAAAAAAAcAAAA4AAAAAAAAAAAAAAAAAAAA////AAAAAAAAAAAAAAAAAAAAAAAAAAAAAAAAAAAAAABkAAAAZAAAAAAAAAAjAAAABAAAAGQAAAAXAAAAFAAAAAAAAAAAAAAA/38AAP9/AAAAAAAACQAAAAQAAAAOAAAAHgAAAGgAAAAAAAAAAAAAAAAAAAAAAAAAAAAAABAnAAAQJwAAAAAAAAAAAAAAAAAAAAAAAAAAAAAAAAAAAAAAAAAAAAAUAAAAAAAAAMDA/wAAAAAAZAAAADIAAAAAAAAAZAAAAAAAAAB/f38ACgAAACIAAAAYAAAAAAAAAAAAAAAAAAAAAAAAAAAAAAAAAAAAJAAAACQAAAAAAAAABwAAAAAAAAAAAAAAAAAAAAAAAAAAAAAAAAAAAH9/fwAlAAAAWAAAAAAAAAAAAAAAAAAAAAAAAAAAAAAAAAAAAAAAAAAAAAAAAAAAAAAAAAAAAAAAPwAAAAAAAACghgEAAAAAAAAAAAAAAAAADAAAAAEAAAAAAAAAAAAAAAAAAAAfAAAAVAAAAEKF9AX///8BAAAAAAAAAAAAAAAAAAAAAAAAAAAAAAAAAAAAAAAAAAAAAAACf39/AFlZWQPMzMwAwMD/AH9/fwAAAAAAAAAAAAAAAAD///8AAAAAACEAAAAYAAAAFAAAAAUDAAB5CwAAQzcAAMkcAAAQAAAAJgAAAAgAAAD//////////w=="/>
               </a:ext>
             </a:extLst>
           </p:cNvPicPr>
@@ -9653,7 +9653,7 @@
             <a:spLocks noGrp="1" noChangeArrowheads="1"/>
             <a:extLst>
               <a:ext uri="smNativeData">
-                <pr:smNativeData xmlns:pr="smNativeData" xmlns="smNativeData" val="SMDATA_15_FUV5ZhMAAAAlAAAAZAAAAA0AAAAAkAAAAJAAAACQAAAAkAAAAAAAAAAAAAAAAAAAAAEAAABQAAAAAAAAAAAA4D8AAAAAAADgPwAAAAAAAOA/AAAAAAAA4D8AAAAAAADgPwAAAAAAAOA/AAAAAAAA4D8AAAAAAADgPwAAAAAAAOA/AAAAAAAA4D8CAAAAjAAAAAAAAAAAAAAAQoX0DP///wgAAAAAAAAAAAAAAAAAAAAAAAAAAAAAAAAAAAAAZAAAAAEAAABAAAAAAAAAAAAAAAAAAAAAAAAAAAAAAAAAAAAAAAAAAAAAAAAAAAAAAAAAAAAAAAAAAAAAAAAAAAAAAAAAAAAAAAAAAAAAAAAAAAAAAAAAAAAAAAAAAAAAFAAAADwAAAAAAAAAAAAAAAAAAAkUAAAAAQAAABQAAAAUAAAAFAAAAAEAAAAAAAAAZAAAAGQAAAAAAAAAZAAAAGQAAAAVAAAAYAAAAAAAAAAAAAAADwAAACADAAAAAAAAAAAAAAEAAACgMgAAVgcAAKr4//8BAAAAf39/AAEAAABkAAAAAAAAABQAAABAHwAAAAAAACYAAAAAAAAAwOD//wAAAAAmAAAAZAAAABYAAABMAAAAAAAAAAAAAAAEAAAAAAAAAAEAAABZWVkKAAAAACgAAAAoAAAAZAAAAGQAAAAAAAAAzMzMAAAAAABQAAAAUAAAAGQAAABkAAAAAAAAABcAAAAUAAAAAAAAAAAAAAD/fwAA/38AAAAAAAAJAAAABAAAAI+nzTQeAAAAaAAAAAAAAAAAAAAAAAAAAAAAAAAAAAAAECcAABAnAAAAAAAAAAAAAAAAAAAAAAAAAAAAAAAAAAAAAAAAAAAAABQAAAAAAAAAwMD/AAAAAABkAAAAMgAAAAAAAABkAAAAAAAAAH9/fwAKAAAAIgAAABgAAAAAAAAAAAAAAAAAAAAAAAAAAAAAAAAAAAAkAAAAJAAAAAAAAAAHAAAAAAAAAAAAAAAAAAAAAAAAAAAAAAAAAAAAf39/ACUAAABYAAAAAAAAAAAAAAAAAAAAAAAAAAAAAAAAAAAAAAAAAAAAAAAAAAAAAAAAAAAAAAA/AAAAAAAAAKCGAQAAAAAAAAAAAAAAAAAMAAAAAQAAAAAAAAAAAAAAAAAAAB8AAABUAAAAQoX0Bf///wEAAAAAAAAAAAAAAAAAAAAAAAAAAAAAAAAAAAAAAAAAAAAAAAJ/f38AWVlZA8zMzADAwP8Af39/AAAAAAAAAAAAAAAAAAAAAAAAAAAAIQAAABgAAAAUAAAAFAMAALYCAAB/NwAAvwoAABAAAAAmAAAACAAAADwwAAAAAAAA"/>
+                <pr:smNativeData xmlns:pr="smNativeData" xmlns="smNativeData" val="SMDATA_15_9kV5ZhMAAAAlAAAAZAAAAA0AAAAAkAAAAJAAAACQAAAAkAAAAAAAAAAAAAAAAAAAAAEAAABQAAAAAAAAAAAA4D8AAAAAAADgPwAAAAAAAOA/AAAAAAAA4D8AAAAAAADgPwAAAAAAAOA/AAAAAAAA4D8AAAAAAADgPwAAAAAAAOA/AAAAAAAA4D8CAAAAjAAAAAAAAAAAAAAAQoX0DP///wgAAAAAAAAAAAAAAAAAAAAAAAAAAAAAAAAAAAAAZAAAAAEAAABAAAAAAAAAAAAAAAAAAAAAAAAAAAAAAAAAAAAAAAAAAAAAAAAAAAAAAAAAAAAAAAAAAAAAAAAAAAAAAAAAAAAAAAAAAAAAAAAAAAAAAAAAAAAAAAAAAAAAFAAAADwAAAAAAAAAAAAAAAAAAAkUAAAAAQAAABQAAAAUAAAAFAAAAAEAAAAAAAAAZAAAAGQAAAAAAAAAZAAAAGQAAAAVAAAAYAAAAAAAAAAAAAAADwAAACADAAAAAAAAAAAAAAEAAACgMgAAVgcAAKr4//8BAAAAf39/AAEAAABkAAAAAAAAABQAAABAHwAAAAAAACYAAAAAAAAAwOD//wAAAAAmAAAAZAAAABYAAABMAAAAAAAAAAAAAAAEAAAAAAAAAAEAAABZWVkKAAAAACgAAAAoAAAAZAAAAGQAAAAAAAAAzMzMAAAAAABQAAAAUAAAAGQAAABkAAAAAAAAABcAAAAUAAAAAAAAAAAAAAD/fwAA/38AAAAAAAAJAAAABAAAAI+nzTQeAAAAaAAAAAAAAAAAAAAAAAAAAAAAAAAAAAAAECcAABAnAAAAAAAAAAAAAAAAAAAAAAAAAAAAAAAAAAAAAAAAAAAAABQAAAAAAAAAwMD/AAAAAABkAAAAMgAAAAAAAABkAAAAAAAAAH9/fwAKAAAAIgAAABgAAAAAAAAAAAAAAAAAAAAAAAAAAAAAAAAAAAAkAAAAJAAAAAAAAAAHAAAAAAAAAAAAAAAAAAAAAAAAAAAAAAAAAAAAf39/ACUAAABYAAAAAAAAAAAAAAAAAAAAAAAAAAAAAAAAAAAAAAAAAAAAAAAAAAAAAAAAAAAAAAA/AAAAAAAAAKCGAQAAAAAAAAAAAAAAAAAMAAAAAQAAAAAAAAAAAAAAAAAAAB8AAABUAAAAQoX0Bf///wEAAAAAAAAAAAAAAAAAAAAAAAAAAAAAAAAAAAAAAAAAAAAAAAJ/f38AWVlZA8zMzADAwP8Af39/AAAAAAAAAAAAAAAAAAAAAAAAAAAAIQAAABgAAAAUAAAAFAMAALYCAAB/NwAAvwoAABAAAAAmAAAACAAAADwwAAAAAAAA"/>
               </a:ext>
             </a:extLst>
           </p:cNvSpPr>
@@ -9843,7 +9843,7 @@
                 </a:tc>
                 <a:extLst>
                   <a:ext uri="smNativeData">
-                    <pr:rowheight xmlns="" xmlns:pr="smNativeData" dt="1719223573" type="min" val="381000"/>
+                    <pr:rowheight xmlns="" xmlns:pr="smNativeData" dt="1719223798" type="min" val="381000"/>
                   </a:ext>
                 </a:extLst>
               </a:tr>
@@ -9991,7 +9991,7 @@
                 </a:tc>
                 <a:extLst>
                   <a:ext uri="smNativeData">
-                    <pr:rowheight xmlns="" xmlns:pr="smNativeData" dt="1719223573" type="min" val="381000"/>
+                    <pr:rowheight xmlns="" xmlns:pr="smNativeData" dt="1719223798" type="min" val="381000"/>
                   </a:ext>
                 </a:extLst>
               </a:tr>
@@ -10139,7 +10139,7 @@
                 </a:tc>
                 <a:extLst>
                   <a:ext uri="smNativeData">
-                    <pr:rowheight xmlns="" xmlns:pr="smNativeData" dt="1719223573" type="min" val="381000"/>
+                    <pr:rowheight xmlns="" xmlns:pr="smNativeData" dt="1719223798" type="min" val="381000"/>
                   </a:ext>
                 </a:extLst>
               </a:tr>
@@ -10153,7 +10153,7 @@
           <p:cNvSpPr>
             <a:extLst>
               <a:ext uri="smNativeData">
-                <pr:smNativeData xmlns:pr="smNativeData" xmlns="smNativeData" val="SMDATA_15_FUV5ZhMAAAAlAAAA9AEAAA0AAAAAOAEAAMYAAAA4AQAAxgAAAAAAAAABAAAAAAAAAAEAAABQAAAAEXC47Anh479Fb0gmzk0BwAAAAAAAAOA/AAAAAAAA4D8AAAAAAADgPwAAAAAAAOA/AAAAAAAA4D8AAAAAAADgPwAAAAAAAOA/AAAAAAAA4D8CAAAAjAAAAAEAAAAAAAAA8/PzAP///wgAAAAAAAAAAAAAAAAAAAAAAAAAAAAAAAAAAAAAeAAAAAEAAABAAAAAAAAAAAAAAABaAAAAAAAAAAAAAAAAAAAAAAAAAAAAAAAAAAAAAAAAAAAAAAAAAAAAAAAAAAAAAAAAAAAAAAAAAAAAAAAAAAAAAAAAAAAAAAAAAAAAFAAAADwAAAABAAAAAAAAAAE9hQAPAAAAAQAAACMAAAAjAAAAIwAAAB4AAAAAAAAASwAAAEsAAAAAAAAASwAAAEsAAAAVAAAAYAAAAAAAAAAAAAAADwAAACADAAAAAAAAAAAAAAEAAACgMgAAVgcAAKr4//8BAAAAf39/AAEAAABkAAAAAAAAABQAAABAHwAAAAAAACYAAAAAAAAAwOD//wAAAAAmAAAAZAAAABYAAABMAAAAAAAAAAAAAAAEAAAAAAAAAAEAAABZWVkKAAAAACgAAAAoAAAAZAAAAGQAAAAAAAAAzMzMAAAAAABQAAAAUAAAAGQAAABkAAAAAAAAABcAAAAUAAAAAAAAAAAAAAD/fwAA/38AAAAAAAAJAAAABAAAADkxY2geAAAAaAAAAAAAAAAAAAAAAAAAAAAAAAAAAAAAECcAABAnAAAAAAAAAAAAAAAAAAAAAAAAAAAAAAAAAAAAAAAAAAAAABQAAAAAAAAAwMD/AAAAAABkAAAAMgAAAAAAAABkAAAAAAAAAH9/fwAKAAAAIgAAABgAAAAAAAAAAAAAAAAAAAAAAAAAAAAAAAAAAAAkAAAAJAAAAAAAAAAHAAAAAAAAAAAAAAAAAAAAAAAAAAAAAAAAAAAAf39/ACUAAABYAAAAAAAAAAAAAAAAAAAAAAAAAAAAAAAAAAAAAAAAAAAAAAAAAAAAAAAAAAAAAAA/AAAAAAAAAKCGAQAAAAAAAAAAAAAAAAAMAAAAAQAAAAAAAAAAAAAAAAAAAB8AAABUAAAA8/PzAP///wEAAAAAAAAAAAAAAAAAAAAAAAAAAAAAAAAAAAAAAAAAAAE9hQB/f38AWVlZA8zMzADAwP8Af39/AAAAAAAAAAAAAAAAAAAAAAAAAAAAIQAAABgAAAAUAAAAVR0AAO0iAABkMgAAMCoAABAAAAAmAAAACAAAAP//////////"/>
+                <pr:smNativeData xmlns:pr="smNativeData" xmlns="smNativeData" val="SMDATA_15_9kV5ZhMAAAAlAAAA9AEAAA0AAAAAOAEAAMYAAAA4AQAAxgAAAAAAAAABAAAAAAAAAAEAAABQAAAAEXC47Anh479Fb0gmzk0BwAAAAAAAAOA/AAAAAAAA4D8AAAAAAADgPwAAAAAAAOA/AAAAAAAA4D8AAAAAAADgPwAAAAAAAOA/AAAAAAAA4D8CAAAAjAAAAAEAAAAAAAAA8/PzAP///wgAAAAAAAAAAAAAAAAAAAAAAAAAAAAAAAAAAAAAeAAAAAEAAABAAAAAAAAAAAAAAABaAAAAAAAAAAAAAAAAAAAAAAAAAAAAAAAAAAAAAAAAAAAAAAAAAAAAAAAAAAAAAAAAAAAAAAAAAAAAAAAAAAAAAAAAAAAAAAAAAAAAFAAAADwAAAABAAAAAAAAAAE9hQAPAAAAAQAAACMAAAAjAAAAIwAAAB4AAAAAAAAASwAAAEsAAAAAAAAASwAAAEsAAAAVAAAAYAAAAAAAAAAAAAAADwAAACADAAAAAAAAAAAAAAEAAACgMgAAVgcAAKr4//8BAAAAf39/AAEAAABkAAAAAAAAABQAAABAHwAAAAAAACYAAAAAAAAAwOD//wAAAAAmAAAAZAAAABYAAABMAAAAAAAAAAAAAAAEAAAAAAAAAAEAAABZWVkKAAAAACgAAAAoAAAAZAAAAGQAAAAAAAAAzMzMAAAAAABQAAAAUAAAAGQAAABkAAAAAAAAABcAAAAUAAAAAAAAAAAAAAD/fwAA/38AAAAAAAAJAAAABAAAADkxY2geAAAAaAAAAAAAAAAAAAAAAAAAAAAAAAAAAAAAECcAABAnAAAAAAAAAAAAAAAAAAAAAAAAAAAAAAAAAAAAAAAAAAAAABQAAAAAAAAAwMD/AAAAAABkAAAAMgAAAAAAAABkAAAAAAAAAH9/fwAKAAAAIgAAABgAAAAAAAAAAAAAAAAAAAAAAAAAAAAAAAAAAAAkAAAAJAAAAAAAAAAHAAAAAAAAAAAAAAAAAAAAAAAAAAAAAAAAAAAAf39/ACUAAABYAAAAAAAAAAAAAAAAAAAAAAAAAAAAAAAAAAAAAAAAAAAAAAAAAAAAAAAAAAAAAAA/AAAAAAAAAKCGAQAAAAAAAAAAAAAAAAAMAAAAAQAAAAAAAAAAAAAAAAAAAB8AAABUAAAA8/PzAP///wEAAAAAAAAAAAAAAAAAAAAAAAAAAAAAAAAAAAAAAAAAAAE9hQB/f38AWVlZA8zMzADAwP8Af39/AAAAAAAAAAAAAAAAAAAAAAAAAAAAIQAAABgAAAAUAAAAVR0AAO0iAABkMgAAMCoAABAAAAAmAAAACAAAAP//////////"/>
               </a:ext>
             </a:extLst>
           </p:cNvSpPr>
@@ -10257,7 +10257,7 @@
             <a:spLocks noGrp="1" noChangeArrowheads="1"/>
             <a:extLst>
               <a:ext uri="smNativeData">
-                <pr:smNativeData xmlns:pr="smNativeData" xmlns="smNativeData" val="SMDATA_15_FUV5ZhMAAAAlAAAAZAAAAA0AAAAAkAAAAJAAAACQAAAAkAAAAAAAAAABAAAAAAAAAAEAAABQAAAAAAAAAAAA4D8AAAAAAADgPwAAAAAAAOA/AAAAAAAA4D8AAAAAAADgPwAAAAAAAOA/AAAAAAAA4D8AAAAAAADgPwAAAAAAAOA/AAAAAAAA4D8CAAAAjAAAAAAAAAAAAAAAQoX0DP///wgAAAAAAAAAAAAAAAAAAAAAAAAAAAAAAAAAAAAAZAAAAAEAAABAAAAAAAAAAAAAAAAAAAAAAAAAAAAAAAAAAAAAAAAAAAAAAAAAAAAAAAAAAAAAAAAAAAAAAAAAAAAAAAAAAAAAAAAAAAAAAAAAAAAAAAAAAAAAAAAAAAAAFAAAADwAAAAAAAAAAAAAAAAAAAkUAAAAAQAAABQAAAAUAAAAFAAAAAEAAAAAAAAAZAAAAGQAAAAAAAAAZAAAAGQAAAAVAAAAYAAAAAAAAAAAAAAADwAAACADAAAAAAAAAAAAAAEAAACgMgAAVgcAAKr4//8BAAAAf39/AAEAAABkAAAAAAAAABQAAABAHwAAAAAAACYAAAAAAAAAwOD//wAAAAAmAAAAZAAAABYAAABMAAAAAAAAAAAAAAAEAAAAAAAAAAEAAABZWVkKAAAAACgAAAAoAAAAZAAAAGQAAAAAAAAAzMzMAAAAAABQAAAAUAAAAGQAAABkAAAAAAAAABcAAAAUAAAAAAAAAAAAAAD/fwAA/38AAAAAAAAJAAAABAAAAJx8t8UeAAAAaAAAAAAAAAAAAAAAAAAAAAAAAAAAAAAAECcAABAnAAAAAAAAAAAAAAAAAAAAAAAAAAAAAAAAAAAAAAAAAAAAABQAAAAAAAAAwMD/AAAAAABkAAAAMgAAAAAAAABkAAAAAAAAAH9/fwAKAAAAIgAAABgAAAAAAAAAAAAAAAAAAAAAAAAAAAAAAAAAAAAkAAAAJAAAAAAAAAAHAAAAAAAAAAAAAAAAAAAAAAAAAAAAAAAAAAAAf39/ACUAAABYAAAAAAAAAAAAAAAAAAAAAAAAAAAAAAAAAAAAAAAAAAAAAAAAAAAAAAAAAAAAAAA/AAAAAAAAAKCGAQAAAAAAAAAAAAAAAAAMAAAAAQAAAAAAAAAAAAAAAAAAAB8AAABUAAAAQoX0Bf///wEAAAAAAAAAAAAAAAAAAAAAAAAAAAAAAAAAAAAAAAAAAAAAAAJ/f38AWVlZA8zMzADAwP8Af39/AAAAAAAAAAAAAAAAAAAAAAAAAAAAIQAAABgAAAAUAAAA4gUAAEADAABiNAAAziQAABAAAAAmAAAACAAAAD0wAAAAAAAA"/>
+                <pr:smNativeData xmlns:pr="smNativeData" xmlns="smNativeData" val="SMDATA_15_9kV5ZhMAAAAlAAAAZAAAAA0AAAAAkAAAAJAAAACQAAAAkAAAAAAAAAABAAAAAAAAAAEAAABQAAAAAAAAAAAA4D8AAAAAAADgPwAAAAAAAOA/AAAAAAAA4D8AAAAAAADgPwAAAAAAAOA/AAAAAAAA4D8AAAAAAADgPwAAAAAAAOA/AAAAAAAA4D8CAAAAjAAAAAAAAAAAAAAAQoX0DP///wgAAAAAAAAAAAAAAAAAAAAAAAAAAAAAAAAAAAAAZAAAAAEAAABAAAAAAAAAAAAAAAAAAAAAAAAAAAAAAAAAAAAAAAAAAAAAAAAAAAAAAAAAAAAAAAAAAAAAAAAAAAAAAAAAAAAAAAAAAAAAAAAAAAAAAAAAAAAAAAAAAAAAFAAAADwAAAAAAAAAAAAAAAAAAAkUAAAAAQAAABQAAAAUAAAAFAAAAAEAAAAAAAAAZAAAAGQAAAAAAAAAZAAAAGQAAAAVAAAAYAAAAAAAAAAAAAAADwAAACADAAAAAAAAAAAAAAEAAACgMgAAVgcAAKr4//8BAAAAf39/AAEAAABkAAAAAAAAABQAAABAHwAAAAAAACYAAAAAAAAAwOD//wAAAAAmAAAAZAAAABYAAABMAAAAAAAAAAAAAAAEAAAAAAAAAAEAAABZWVkKAAAAACgAAAAoAAAAZAAAAGQAAAAAAAAAzMzMAAAAAABQAAAAUAAAAGQAAABkAAAAAAAAABcAAAAUAAAAAAAAAAAAAAD/fwAA/38AAAAAAAAJAAAABAAAAJx8t8UeAAAAaAAAAAAAAAAAAAAAAAAAAAAAAAAAAAAAECcAABAnAAAAAAAAAAAAAAAAAAAAAAAAAAAAAAAAAAAAAAAAAAAAABQAAAAAAAAAwMD/AAAAAABkAAAAMgAAAAAAAABkAAAAAAAAAH9/fwAKAAAAIgAAABgAAAAAAAAAAAAAAAAAAAAAAAAAAAAAAAAAAAAkAAAAJAAAAAAAAAAHAAAAAAAAAAAAAAAAAAAAAAAAAAAAAAAAAAAAf39/ACUAAABYAAAAAAAAAAAAAAAAAAAAAAAAAAAAAAAAAAAAAAAAAAAAAAAAAAAAAAAAAAAAAAA/AAAAAAAAAKCGAQAAAAAAAAAAAAAAAAAMAAAAAQAAAAAAAAAAAAAAAAAAAB8AAABUAAAAQoX0Bf///wEAAAAAAAAAAAAAAAAAAAAAAAAAAAAAAAAAAAAAAAAAAAAAAAJ/f38AWVlZA8zMzADAwP8Af39/AAAAAAAAAAAAAAAAAAAAAAAAAAAAIQAAABgAAAAUAAAA4gUAAEADAABiNAAAziQAABAAAAAmAAAACAAAAD0wAAAAAAAA"/>
               </a:ext>
             </a:extLst>
           </p:cNvSpPr>
@@ -10350,7 +10350,7 @@
           <p:cNvSpPr>
             <a:extLst>
               <a:ext uri="smNativeData">
-                <pr:smNativeData xmlns:pr="smNativeData" xmlns="smNativeData" val="SMDATA_15_FUV5ZhMAAAAlAAAAZAAAAA0AAAAAkAAAAJAAAACQAAAAkAAAAAAAAAABAAAAAAAAAAEAAABQAAAAAAAAAAAA4D8AAAAAAADgPwAAAAAAAOA/AAAAAAAA4D8AAAAAAADgPwAAAAAAAOA/AAAAAAAA4D8AAAAAAADgPwAAAAAAAOA/AAAAAAAA4D8CAAAAjAAAAAAAAAAAAAAAQoX0DP///wgAAAAAAAAAAAAAAAAAAAAAAAAAAAAAAAAAAAAAZAAAAAEAAABAAAAAAAAAAAAAAAAAAAAAAAAAAAAAAAAAAAAAAAAAAAAAAAAAAAAAAAAAAAAAAAAAAAAAAAAAAAAAAAAAAAAAAAAAAAAAAAAAAAAAAAAAAAAAAAAAAAAAFAAAADwAAAAAAAAAAAAAAAAAAAkUAAAAAQAAABQAAAAUAAAAFAAAAAEAAAAAAAAAZAAAAGQAAAAAAAAAZAAAAGQAAAAVAAAAYAAAAAAAAAAAAAAADwAAACADAAAAAAAAAAAAAAEAAACgMgAAVgcAAKr4//8BAAAAf39/AAEAAABkAAAAAAAAABQAAABAHwAAAAAAACYAAAAAAAAAwOD//wAAAAAmAAAAZAAAABYAAABMAAAAAAAAAAAAAAAEAAAAAAAAAAEAAABZWVkKAAAAACgAAAAoAAAAZAAAAGQAAAAAAAAAzMzMAAAAAABQAAAAUAAAAGQAAABkAAAAAAAAABcAAAAUAAAAAAAAAAAAAAD/fwAA/38AAAAAAAAJAAAABAAAAF8AYAAeAAAAaAAAAAAAAAAAAAAAAAAAAAAAAAAAAAAAECcAABAnAAAAAAAAAAAAAAAAAAAAAAAAAAAAAAAAAAAAAAAAAAAAABQAAAAAAAAAwMD/AAAAAABkAAAAMgAAAAAAAABkAAAAAAAAAH9/fwAKAAAAIgAAABgAAAAAAAAAAAAAAAAAAAAAAAAAAAAAAAAAAAAkAAAAJAAAAAAAAAAHAAAAAAAAAAAAAAAAAAAAAAAAAAAAAAAAAAAAf39/ACUAAABYAAAAAAAAAAAAAAAAAAAAAAAAAAAAAAAAAAAAAAAAAAAAAAAAAAAAAAAAAAAAAAA/AAAAAAAAAKCGAQAAAAAAAAAAAAAAAAAMAAAAAQAAAAAAAAAAAAAAAAAAAB8AAABUAAAAQoX0Bf///wEAAAAAAAAAAAAAAAAAAAAAAAAAAAAAAAAAAAAAAAAAAAAAAAJ/f38AWVlZA8zMzADAwP8Af39/AAAAAAAAAAAAAAAAAAAAAAAAAAAAIQAAABgAAAAUAAAAtwQAAMgQAACINQAAsBcAABAAAAAmAAAACAAAAP//////////"/>
+                <pr:smNativeData xmlns:pr="smNativeData" xmlns="smNativeData" val="SMDATA_15_9kV5ZhMAAAAlAAAAZAAAAA0AAAAAkAAAAJAAAACQAAAAkAAAAAAAAAABAAAAAAAAAAEAAABQAAAAAAAAAAAA4D8AAAAAAADgPwAAAAAAAOA/AAAAAAAA4D8AAAAAAADgPwAAAAAAAOA/AAAAAAAA4D8AAAAAAADgPwAAAAAAAOA/AAAAAAAA4D8CAAAAjAAAAAAAAAAAAAAAQoX0DP///wgAAAAAAAAAAAAAAAAAAAAAAAAAAAAAAAAAAAAAZAAAAAEAAABAAAAAAAAAAAAAAAAAAAAAAAAAAAAAAAAAAAAAAAAAAAAAAAAAAAAAAAAAAAAAAAAAAAAAAAAAAAAAAAAAAAAAAAAAAAAAAAAAAAAAAAAAAAAAAAAAAAAAFAAAADwAAAAAAAAAAAAAAAAAAAkUAAAAAQAAABQAAAAUAAAAFAAAAAEAAAAAAAAAZAAAAGQAAAAAAAAAZAAAAGQAAAAVAAAAYAAAAAAAAAAAAAAADwAAACADAAAAAAAAAAAAAAEAAACgMgAAVgcAAKr4//8BAAAAf39/AAEAAABkAAAAAAAAABQAAABAHwAAAAAAACYAAAAAAAAAwOD//wAAAAAmAAAAZAAAABYAAABMAAAAAAAAAAAAAAAEAAAAAAAAAAEAAABZWVkKAAAAACgAAAAoAAAAZAAAAGQAAAAAAAAAzMzMAAAAAABQAAAAUAAAAGQAAABkAAAAAAAAABcAAAAUAAAAAAAAAAAAAAD/fwAA/38AAAAAAAAJAAAABAAAAF8AYAAeAAAAaAAAAAAAAAAAAAAAAAAAAAAAAAAAAAAAECcAABAnAAAAAAAAAAAAAAAAAAAAAAAAAAAAAAAAAAAAAAAAAAAAABQAAAAAAAAAwMD/AAAAAABkAAAAMgAAAAAAAABkAAAAAAAAAH9/fwAKAAAAIgAAABgAAAAAAAAAAAAAAAAAAAAAAAAAAAAAAAAAAAAkAAAAJAAAAAAAAAAHAAAAAAAAAAAAAAAAAAAAAAAAAAAAAAAAAAAAf39/ACUAAABYAAAAAAAAAAAAAAAAAAAAAAAAAAAAAAAAAAAAAAAAAAAAAAAAAAAAAAAAAAAAAAA/AAAAAAAAAKCGAQAAAAAAAAAAAAAAAAAMAAAAAQAAAAAAAAAAAAAAAAAAAB8AAABUAAAAQoX0Bf///wEAAAAAAAAAAAAAAAAAAAAAAAAAAAAAAAAAAAAAAAAAAAAAAAJ/f38AWVlZA8zMzADAwP8Af39/AAAAAAAAAAAAAAAAAAAAAAAAAAAAIQAAABgAAAAUAAAAtwQAAMgQAACINQAAsBcAABAAAAAmAAAACAAAAP//////////"/>
               </a:ext>
             </a:extLst>
           </p:cNvSpPr>
@@ -10429,7 +10429,7 @@
           <p:cNvPicPr>
             <a:extLst>
               <a:ext uri="smNativeData">
-                <pr:smNativeData xmlns:pr="smNativeData" xmlns="smNativeData" val="SMDATA_17_FUV5ZhMAAAAlAAAAEQAAAA0AAAAAkAAAAEgAAACQAAAASAAAAAAAAAAAAAAAAAAAAAEAAABQAAAAAAAAAAAA4D8AAAAAAADgPwAAAAAAAOA/AAAAAAAA4D8AAAAAAADgPwAAAAAAAOA/AAAAAAAA4D8AAAAAAADgPwAAAAAAAOA/AAAAAAAA4D8CAAAAjAAAAAAAAAAAAAAAQoX0DP///wgAAAAAAAAAAAAAAAAAAAAAAAAAAAAAAAAAAAAAZAAAAAEAAABAAAAAAAAAAAAAAAAAAAAAAAAAAAAAAAAAAAAAAAAAAAAAAAAAAAAAAAAAAAAAAAAAAAAAAAAAAAAAAAAAAAAAAAAAAAAAAAAAAAAAAAAAAAAAAAAAAAAAFAAAADwAAAAAAAAAAAAAAAAAAAkUAAAAAQAAABQAAAAUAAAAFAAAAAEAAAAAAAAAZAAAAGQAAAAAAAAAZAAAAGQAAAAVAAAAYAAAAAAAAAAAAAAADwAAACADAAAAAAAAAAAAAAEAAACgMgAAVgcAAKr4//8BAAAAf39/AAEAAABkAAAAAAAAABQAAABAHwAAAAAAACYAAAAAAAAAwOD//wAAAAAmAAAAZAAAABYAAABMAAAAAAAAAAAAAAAEAAAAAAAAAAEAAABZWVkKAAAAACgAAAAoAAAAZAAAAGQAAAAAAAAAzMzMAAAAAABQAAAAUAAAAGQAAABkAAAAAAAAAAcAAAA4AAAAAAAAAAAAAAAAAAAA////AAAAAAAAAAAAAAAAAAAAAAAAAAAAAAAAAAAAAABkAAAAZAAAAAAAAAAjAAAABAAAAGQAAAAXAAAAFAAAAAAAAAAAAAAA/38AAP9/AAAAAAAACQAAAAQAAAAAAAAAHgAAAGgAAAAAAAAAAAAAAAAAAAAAAAAAAAAAABAnAAAQJwAAAAAAAAAAAAAAAAAAAAAAAAAAAAAAAAAAAAAAAAAAAAAUAAAAAAAAAMDA/wAAAAAAZAAAADIAAAAAAAAAZAAAAAAAAAB/f38ACgAAACIAAAAYAAAAAAAAAAAAAAAAAAAAAAAAAAAAAAAAAAAAJAAAACQAAAAAAAAABwAAAAAAAAAAAAAAAAAAAAAAAAAAAAAAAAAAAH9/fwAlAAAAWAAAAAAAAAAAAAAAAAAAAAAAAAAAAAAAAAAAAAAAAAAAAAAAAAAAAAAAAAAAAAAAPwAAAAAAAACghgEAAAAAAAAAAAAAAAAADAAAAAEAAAAAAAAAAAAAAAAAAAAfAAAAVAAAAEKF9AX///8BAAAAAAAAAAAAAAAAAAAAAAAAAAAAAAAAAAAAAAAAAAAAAAACf39/AFlZWQPMzMwAwMD/AH9/fwAAAAAAAAAAAAAAAAD///8AAAAAACEAAAAYAAAAFAAAAEYFAAD3GgAAmAkAAEkfAAAQAAAAJgAAAAgAAAD//////////w=="/>
+                <pr:smNativeData xmlns:pr="smNativeData" xmlns="smNativeData" val="SMDATA_17_9kV5ZhMAAAAlAAAAEQAAAA0AAAAAkAAAAEgAAACQAAAASAAAAAAAAAAAAAAAAAAAAAEAAABQAAAAAAAAAAAA4D8AAAAAAADgPwAAAAAAAOA/AAAAAAAA4D8AAAAAAADgPwAAAAAAAOA/AAAAAAAA4D8AAAAAAADgPwAAAAAAAOA/AAAAAAAA4D8CAAAAjAAAAAAAAAAAAAAAQoX0DP///wgAAAAAAAAAAAAAAAAAAAAAAAAAAAAAAAAAAAAAZAAAAAEAAABAAAAAAAAAAAAAAAAAAAAAAAAAAAAAAAAAAAAAAAAAAAAAAAAAAAAAAAAAAAAAAAAAAAAAAAAAAAAAAAAAAAAAAAAAAAAAAAAAAAAAAAAAAAAAAAAAAAAAFAAAADwAAAAAAAAAAAAAAAAAAAkUAAAAAQAAABQAAAAUAAAAFAAAAAEAAAAAAAAAZAAAAGQAAAAAAAAAZAAAAGQAAAAVAAAAYAAAAAAAAAAAAAAADwAAACADAAAAAAAAAAAAAAEAAACgMgAAVgcAAKr4//8BAAAAf39/AAEAAABkAAAAAAAAABQAAABAHwAAAAAAACYAAAAAAAAAwOD//wAAAAAmAAAAZAAAABYAAABMAAAAAAAAAAAAAAAEAAAAAAAAAAEAAABZWVkKAAAAACgAAAAoAAAAZAAAAGQAAAAAAAAAzMzMAAAAAABQAAAAUAAAAGQAAABkAAAAAAAAAAcAAAA4AAAAAAAAAAAAAAAAAAAA////AAAAAAAAAAAAAAAAAAAAAAAAAAAAAAAAAAAAAABkAAAAZAAAAAAAAAAjAAAABAAAAGQAAAAXAAAAFAAAAAAAAAAAAAAA/38AAP9/AAAAAAAACQAAAAQAAAAAAAAAHgAAAGgAAAAAAAAAAAAAAAAAAAAAAAAAAAAAABAnAAAQJwAAAAAAAAAAAAAAAAAAAAAAAAAAAAAAAAAAAAAAAAAAAAAUAAAAAAAAAMDA/wAAAAAAZAAAADIAAAAAAAAAZAAAAAAAAAB/f38ACgAAACIAAAAYAAAAAAAAAAAAAAAAAAAAAAAAAAAAAAAAAAAAJAAAACQAAAAAAAAABwAAAAAAAAAAAAAAAAAAAAAAAAAAAAAAAAAAAH9/fwAlAAAAWAAAAAAAAAAAAAAAAAAAAAAAAAAAAAAAAAAAAAAAAAAAAAAAAAAAAAAAAAAAAAAAPwAAAAAAAACghgEAAAAAAAAAAAAAAAAADAAAAAEAAAAAAAAAAAAAAAAAAAAfAAAAVAAAAEKF9AX///8BAAAAAAAAAAAAAAAAAAAAAAAAAAAAAAAAAAAAAAAAAAAAAAACf39/AFlZWQPMzMwAwMD/AH9/fwAAAAAAAAAAAAAAAAD///8AAAAAACEAAAAYAAAAFAAAAEYFAAD3GgAAmAkAAEkfAAAQAAAAJgAAAAgAAAD//////////w=="/>
               </a:ext>
             </a:extLst>
           </p:cNvPicPr>
@@ -10462,7 +10462,7 @@
           <p:cNvPicPr>
             <a:extLst>
               <a:ext uri="smNativeData">
-                <pr:smNativeData xmlns:pr="smNativeData" xmlns="smNativeData" val="SMDATA_17_FUV5ZhMAAAAlAAAAEQAAAA0AAAAAkAAAAEgAAACQAAAASAAAAAAAAAAAAAAAAAAAAAEAAABQAAAAAAAAAAAA4D8AAAAAAADgPwAAAAAAAOA/AAAAAAAA4D8AAAAAAADgPwAAAAAAAOA/AAAAAAAA4D8AAAAAAADgPwAAAAAAAOA/AAAAAAAA4D8CAAAAjAAAAAAAAAAAAAAAQoX0DP///wgAAAAAAAAAAAAAAAAAAAAAAAAAAAAAAAAAAAAAZAAAAAEAAABAAAAAAAAAAAAAAAAAAAAAAAAAAAAAAAAAAAAAAAAAAAAAAAAAAAAAAAAAAAAAAAAAAAAAAAAAAAAAAAAAAAAAAAAAAAAAAAAAAAAAAAAAAAAAAAAAAAAAFAAAADwAAAAAAAAAAAAAAAAAAAkUAAAAAQAAABQAAAAUAAAAFAAAAAEAAAAAAAAAZAAAAGQAAAAAAAAAZAAAAGQAAAAVAAAAYAAAAAAAAAAAAAAADwAAACADAAAAAAAAAAAAAAEAAACgMgAAVgcAAKr4//8BAAAAf39/AAEAAABkAAAAAAAAABQAAABAHwAAAAAAACYAAAAAAAAAwOD//wAAAAAmAAAAZAAAABYAAABMAAAAAAAAAAAAAAAEAAAAAAAAAAEAAABZWVkKAAAAACgAAAAoAAAAZAAAAGQAAAAAAAAAzMzMAAAAAABQAAAAUAAAAGQAAABkAAAAAAAAAAcAAAA4AAAAAAAAAAAAAAAAAAAA////AAAAAAAAAAAAAAAAAAAAAAAAAAAAAAAAAAAAAABkAAAAZAAAAAAAAAAjAAAABAAAAGQAAAAXAAAAFAAAAAAAAAAAAAAA/38AAP9/AAAAAAAACQAAAAQAAADPAQAAHgAAAGgAAAAAAAAAAAAAAAAAAAAAAAAAAAAAABAnAAAQJwAAAAAAAAAAAAAAAAAAAAAAAAAAAAAAAAAAAAAAAAAAAAAUAAAAAAAAAMDA/wAAAAAAZAAAADIAAAAAAAAAZAAAAAAAAAB/f38ACgAAACIAAAAYAAAAAAAAAAAAAAAAAAAAAAAAAAAAAAAAAAAAJAAAACQAAAAAAAAABwAAAAAAAAAAAAAAAAAAAAAAAAAAAAAAAAAAAH9/fwAlAAAAWAAAAAAAAAAAAAAAAAAAAAAAAAAAAAAAAAAAAAAAAAAAAAAAAAAAAAAAAAAAAAAAPwAAAAAAAACghgEAAAAAAAAAAAAAAAAADAAAAAEAAAAAAAAAAAAAAAAAAAAfAAAAVAAAAEKF9AX///8BAAAAAAAAAAAAAAAAAAAAAAAAAAAAAAAAAAAAAAAAAAAAAAACf39/AFlZWQPMzMwAwMD/AH9/fwAAAAAAAAAAAAAAAAD///8AAAAAACEAAAAYAAAAFAAAALAKAAD3GgAAAg8AAEkfAAAQAAAAJgAAAAgAAAD//////////w=="/>
+                <pr:smNativeData xmlns:pr="smNativeData" xmlns="smNativeData" val="SMDATA_17_9kV5ZhMAAAAlAAAAEQAAAA0AAAAAkAAAAEgAAACQAAAASAAAAAAAAAAAAAAAAAAAAAEAAABQAAAAAAAAAAAA4D8AAAAAAADgPwAAAAAAAOA/AAAAAAAA4D8AAAAAAADgPwAAAAAAAOA/AAAAAAAA4D8AAAAAAADgPwAAAAAAAOA/AAAAAAAA4D8CAAAAjAAAAAAAAAAAAAAAQoX0DP///wgAAAAAAAAAAAAAAAAAAAAAAAAAAAAAAAAAAAAAZAAAAAEAAABAAAAAAAAAAAAAAAAAAAAAAAAAAAAAAAAAAAAAAAAAAAAAAAAAAAAAAAAAAAAAAAAAAAAAAAAAAAAAAAAAAAAAAAAAAAAAAAAAAAAAAAAAAAAAAAAAAAAAFAAAADwAAAAAAAAAAAAAAAAAAAkUAAAAAQAAABQAAAAUAAAAFAAAAAEAAAAAAAAAZAAAAGQAAAAAAAAAZAAAAGQAAAAVAAAAYAAAAAAAAAAAAAAADwAAACADAAAAAAAAAAAAAAEAAACgMgAAVgcAAKr4//8BAAAAf39/AAEAAABkAAAAAAAAABQAAABAHwAAAAAAACYAAAAAAAAAwOD//wAAAAAmAAAAZAAAABYAAABMAAAAAAAAAAAAAAAEAAAAAAAAAAEAAABZWVkKAAAAACgAAAAoAAAAZAAAAGQAAAAAAAAAzMzMAAAAAABQAAAAUAAAAGQAAABkAAAAAAAAAAcAAAA4AAAAAAAAAAAAAAAAAAAA////AAAAAAAAAAAAAAAAAAAAAAAAAAAAAAAAAAAAAABkAAAAZAAAAAAAAAAjAAAABAAAAGQAAAAXAAAAFAAAAAAAAAAAAAAA/38AAP9/AAAAAAAACQAAAAQAAADPAQAAHgAAAGgAAAAAAAAAAAAAAAAAAAAAAAAAAAAAABAnAAAQJwAAAAAAAAAAAAAAAAAAAAAAAAAAAAAAAAAAAAAAAAAAAAAUAAAAAAAAAMDA/wAAAAAAZAAAADIAAAAAAAAAZAAAAAAAAAB/f38ACgAAACIAAAAYAAAAAAAAAAAAAAAAAAAAAAAAAAAAAAAAAAAAJAAAACQAAAAAAAAABwAAAAAAAAAAAAAAAAAAAAAAAAAAAAAAAAAAAH9/fwAlAAAAWAAAAAAAAAAAAAAAAAAAAAAAAAAAAAAAAAAAAAAAAAAAAAAAAAAAAAAAAAAAAAAAPwAAAAAAAACghgEAAAAAAAAAAAAAAAAADAAAAAEAAAAAAAAAAAAAAAAAAAAfAAAAVAAAAEKF9AX///8BAAAAAAAAAAAAAAAAAAAAAAAAAAAAAAAAAAAAAAAAAAAAAAACf39/AFlZWQPMzMwAwMD/AH9/fwAAAAAAAAAAAAAAAAD///8AAAAAACEAAAAYAAAAFAAAALAKAAD3GgAAAg8AAEkfAAAQAAAAJgAAAAgAAAD//////////w=="/>
               </a:ext>
             </a:extLst>
           </p:cNvPicPr>
@@ -10527,7 +10527,7 @@
           <p:cNvSpPr>
             <a:extLst>
               <a:ext uri="smNativeData">
-                <pr:smNativeData xmlns:pr="smNativeData" xmlns="smNativeData" val="SMDATA_15_FUV5ZhMAAAAlAAAAZAAAAA0AAAAAkAAAAJAAAACQAAAAkAAAAAAAAAABAAAAAAAAAAEAAABQAAAAAAAAAAAA4D8AAAAAAADgPwAAAAAAAOA/AAAAAAAA4D8AAAAAAADgPwAAAAAAAOA/AAAAAAAA4D8AAAAAAADgPwAAAAAAAOA/AAAAAAAA4D8CAAAAjAAAAAEAAAAAAAAAAT2FAP///wgAAAAAAAAAAAAAAAAAAAAAAAAAAAAAAAAAAAAAeAAAAAEAAABAAAAAAAAAAAAAAABaAAAAAAAAAAAAAAAAAAAAAAAAAAAAAAAAAAAAAAAAAAAAAAAAAAAAAAAAAAAAAAAAAAAAAAAAAAAAAAAAAAAAAAAAAAAAAAAAAAAAFAAAADwAAAAAAAAAAAAAAAAAAAkUAAAAAQAAABQAAAAUAAAAFAAAAAEAAAAAAAAAZAAAAGQAAAAAAAAAZAAAAGQAAAAVAAAAYAAAAAAAAAAAAAAADwAAACADAAAAAAAAAAAAAAEAAACgMgAAVgcAAKr4//8BAAAAf39/AAEAAABkAAAAAAAAABQAAABAHwAAAAAAACYAAAAAAAAAwOD//wAAAAAmAAAAZAAAABYAAABMAAAAAAAAAAAAAAAEAAAAAAAAAAEAAABZWVkKAAAAACgAAAAoAAAAZAAAAGQAAAAAAAAAzMzMAAAAAABQAAAAUAAAAGQAAABkAAAAAAAAABcAAAAUAAAAAAAAAAAAAAD/fwAA/38AAAAAAAAJAAAABAAAAF8AYAAeAAAAaAAAAAAAAAAAAAAAAAAAAAAAAAAAAAAAECcAABAnAAAAAAAAAAAAAAAAAAAAAAAAAAAAAAAAAAAAAAAAAAAAABQAAAAAAAAAwMD/AAAAAABkAAAAMgAAAAAAAABkAAAAAAAAAH9/fwAKAAAAIgAAABgAAAAAAAAAAAAAAAAAAAAAAAAAAAAAAAAAAAAkAAAAJAAAAAAAAAAHAAAAAAAAAAAAAAAAAAAAAAAAAAAAAAAAAAAAf39/ACUAAABYAAAAAAAAAAAAAAAAAAAAAAAAAAAAAAAAAAAAAAAAAAAAAAAAAAAAAAAAAAAAAAA/AAAAAAAAAKCGAQAAAAAAAAAAAAAAAAAMAAAAAQAAAAAAAAAAAAAAAAAAAB8AAABUAAAAAT2FAP///wEAAAAAAAAAAAAAAAAAAAAAAAAAAAAAAAAAAAAAAAAAAAAAAAJ/f38AWVlZA8zMzADAwP8Af39/AAAAAAAAAAAAAAAAAAAAAAAAAAAAIQAAABgAAAAUAAAA4AMAALMWAAAyDQAAniUAABAAAAAmAAAACAAAAP//////////"/>
+                <pr:smNativeData xmlns:pr="smNativeData" xmlns="smNativeData" val="SMDATA_15_9kV5ZhMAAAAlAAAAZAAAAA0AAAAAkAAAAJAAAACQAAAAkAAAAAAAAAABAAAAAAAAAAEAAABQAAAAAAAAAAAA4D8AAAAAAADgPwAAAAAAAOA/AAAAAAAA4D8AAAAAAADgPwAAAAAAAOA/AAAAAAAA4D8AAAAAAADgPwAAAAAAAOA/AAAAAAAA4D8CAAAAjAAAAAEAAAAAAAAAAT2FAP///wgAAAAAAAAAAAAAAAAAAAAAAAAAAAAAAAAAAAAAeAAAAAEAAABAAAAAAAAAAAAAAABaAAAAAAAAAAAAAAAAAAAAAAAAAAAAAAAAAAAAAAAAAAAAAAAAAAAAAAAAAAAAAAAAAAAAAAAAAAAAAAAAAAAAAAAAAAAAAAAAAAAAFAAAADwAAAAAAAAAAAAAAAAAAAkUAAAAAQAAABQAAAAUAAAAFAAAAAEAAAAAAAAAZAAAAGQAAAAAAAAAZAAAAGQAAAAVAAAAYAAAAAAAAAAAAAAADwAAACADAAAAAAAAAAAAAAEAAACgMgAAVgcAAKr4//8BAAAAf39/AAEAAABkAAAAAAAAABQAAABAHwAAAAAAACYAAAAAAAAAwOD//wAAAAAmAAAAZAAAABYAAABMAAAAAAAAAAAAAAAEAAAAAAAAAAEAAABZWVkKAAAAACgAAAAoAAAAZAAAAGQAAAAAAAAAzMzMAAAAAABQAAAAUAAAAGQAAABkAAAAAAAAABcAAAAUAAAAAAAAAAAAAAD/fwAA/38AAAAAAAAJAAAABAAAAF8AYAAeAAAAaAAAAAAAAAAAAAAAAAAAAAAAAAAAAAAAECcAABAnAAAAAAAAAAAAAAAAAAAAAAAAAAAAAAAAAAAAAAAAAAAAABQAAAAAAAAAwMD/AAAAAABkAAAAMgAAAAAAAABkAAAAAAAAAH9/fwAKAAAAIgAAABgAAAAAAAAAAAAAAAAAAAAAAAAAAAAAAAAAAAAkAAAAJAAAAAAAAAAHAAAAAAAAAAAAAAAAAAAAAAAAAAAAAAAAAAAAf39/ACUAAABYAAAAAAAAAAAAAAAAAAAAAAAAAAAAAAAAAAAAAAAAAAAAAAAAAAAAAAAAAAAAAAA/AAAAAAAAAKCGAQAAAAAAAAAAAAAAAAAMAAAAAQAAAAAAAAAAAAAAAAAAAB8AAABUAAAAAT2FAP///wEAAAAAAAAAAAAAAAAAAAAAAAAAAAAAAAAAAAAAAAAAAAAAAAJ/f38AWVlZA8zMzADAwP8Af39/AAAAAAAAAAAAAAAAAAAAAAAAAAAAIQAAABgAAAAUAAAA4AMAAHUYAAAyDQAAniUAABAAAAAmAAAACAAAAP//////////"/>
               </a:ext>
             </a:extLst>
           </p:cNvSpPr>
@@ -10535,8 +10535,8 @@
         </p:nvSpPr>
         <p:spPr>
           <a:xfrm>
-            <a:off x="629920" y="3689985"/>
-            <a:ext cx="1515110" cy="2425065"/>
+            <a:off x="629920" y="3975735"/>
+            <a:ext cx="1515110" cy="2139315"/>
           </a:xfrm>
           <a:prstGeom prst="rect">
             <a:avLst/>
@@ -10572,7 +10572,7 @@
             <a:spLocks noGrp="1" noChangeArrowheads="1"/>
             <a:extLst>
               <a:ext uri="smNativeData">
-                <pr:smNativeData xmlns:pr="smNativeData" xmlns="smNativeData" val="SMDATA_15_FUV5ZhMAAAAlAAAAZAAAAA0AAAAAkAAAAJAAAACQAAAAkAAAAAAAAAAAAAAAAAAAAAEAAABQAAAAAAAAAAAA4D8AAAAAAADgPwAAAAAAAOA/AAAAAAAA4D8AAAAAAADgPwAAAAAAAOA/AAAAAAAA4D8AAAAAAADgPwAAAAAAAOA/AAAAAAAA4D8CAAAAjAAAAAAAAAAAAAAAQoX0DP///wgAAAAAAAAAAAAAAAAAAAAAAAAAAAAAAAAAAAAAZAAAAAEAAABAAAAAAAAAAAAAAAAAAAAAAAAAAAAAAAAAAAAAAAAAAAAAAAAAAAAAAAAAAAAAAAAAAAAAAAAAAAAAAAAAAAAAAAAAAAAAAAAAAAAAAAAAAAAAAAAAAAAAFAAAADwAAAAAAAAAAAAAAAAAAAkUAAAAAQAAABQAAAAUAAAAFAAAAAEAAAAAAAAAZAAAAGQAAAAAAAAAZAAAAGQAAAAVAAAAYAAAAAAAAAAAAAAADwAAACADAAAAAAAAAAAAAAEAAACgMgAAVgcAAKr4//8BAAAAf39/AAEAAABkAAAAAAAAABQAAABAHwAAAAAAACYAAAAAAAAAwOD//wAAAAAmAAAAZAAAABYAAABMAAAAAAAAAAAAAAAEAAAAAAAAAAEAAABZWVkKAAAAACgAAAAoAAAAZAAAAGQAAAAAAAAAzMzMAAAAAABQAAAAUAAAAGQAAABkAAAAAAAAABcAAAAUAAAAAAAAAAAAAAD/fwAA/38AAAAAAAAJAAAABAAAAJrHIpceAAAAaAAAAAAAAAAAAAAAAAAAAAAAAAAAAAAAECcAABAnAAAAAAAAAAAAAAAAAAAAAAAAAAAAAAAAAAAAAAAAAAAAABQAAAAAAAAAwMD/AAAAAABkAAAAMgAAAAAAAABkAAAAAAAAAH9/fwAKAAAAIgAAABgAAAAAAAAAAAAAAAAAAAAAAAAAAAAAAAAAAAAkAAAAJAAAAAAAAAAHAAAAAAAAAAAAAAAAAAAAAAAAAAAAAAAAAAAAf39/ACUAAABYAAAAAAAAAAAAAAAAAAAAAAAAAAAAAAAAAAAAAAAAAAAAAAAAAAAAAAAAAAAAAAA/AAAAAAAAAKCGAQAAAAAAAAAAAAAAAAAMAAAAAQAAAAAAAAAAAAAAAAAAAB8AAABUAAAAQoX0Bf///wEAAAAAAAAAAAAAAAAAAAAAAAAAAAAAAAAAAAAAAAAAAAAAAAJ/f38AWVlZA8zMzADAwP8Af39/AAAAAAAAAAAAAAAAAAAAAAAAAAAAIQAAABgAAAAUAAAAFAMAAFQEAAB/NwAAOxQAABAAAAAmAAAACAAAAD0wAAAAAAAA"/>
+                <pr:smNativeData xmlns:pr="smNativeData" xmlns="smNativeData" val="SMDATA_15_9kV5ZhMAAAAlAAAAZAAAAA0AAAAAkAAAAJAAAACQAAAAkAAAAAAAAAAAAAAAAAAAAAEAAABQAAAAAAAAAAAA4D8AAAAAAADgPwAAAAAAAOA/AAAAAAAA4D8AAAAAAADgPwAAAAAAAOA/AAAAAAAA4D8AAAAAAADgPwAAAAAAAOA/AAAAAAAA4D8CAAAAjAAAAAAAAAAAAAAAQoX0DP///wgAAAAAAAAAAAAAAAAAAAAAAAAAAAAAAAAAAAAAZAAAAAEAAABAAAAAAAAAAAAAAAAAAAAAAAAAAAAAAAAAAAAAAAAAAAAAAAAAAAAAAAAAAAAAAAAAAAAAAAAAAAAAAAAAAAAAAAAAAAAAAAAAAAAAAAAAAAAAAAAAAAAAFAAAADwAAAAAAAAAAAAAAAAAAAkUAAAAAQAAABQAAAAUAAAAFAAAAAEAAAAAAAAAZAAAAGQAAAAAAAAAZAAAAGQAAAAVAAAAYAAAAAAAAAAAAAAADwAAACADAAAAAAAAAAAAAAEAAACgMgAAVgcAAKr4//8BAAAAf39/AAEAAABkAAAAAAAAABQAAABAHwAAAAAAACYAAAAAAAAAwOD//wAAAAAmAAAAZAAAABYAAABMAAAAAAAAAAAAAAAEAAAAAAAAAAEAAABZWVkKAAAAACgAAAAoAAAAZAAAAGQAAAAAAAAAzMzMAAAAAABQAAAAUAAAAGQAAABkAAAAAAAAABcAAAAUAAAAAAAAAAAAAAD/fwAA/38AAAAAAAAJAAAABAAAAJrHIpceAAAAaAAAAAAAAAAAAAAAAAAAAAAAAAAAAAAAECcAABAnAAAAAAAAAAAAAAAAAAAAAAAAAAAAAAAAAAAAAAAAAAAAABQAAAAAAAAAwMD/AAAAAABkAAAAMgAAAAAAAABkAAAAAAAAAH9/fwAKAAAAIgAAABgAAAAAAAAAAAAAAAAAAAAAAAAAAAAAAAAAAAAkAAAAJAAAAAAAAAAHAAAAAAAAAAAAAAAAAAAAAAAAAAAAAAAAAAAAf39/ACUAAABYAAAAAAAAAAAAAAAAAAAAAAAAAAAAAAAAAAAAAAAAAAAAAAAAAAAAAAAAAAAAAAA/AAAAAAAAAKCGAQAAAAAAAAAAAAAAAAAMAAAAAQAAAAAAAAAAAAAAAAAAAB8AAABUAAAAQoX0Bf///wEAAAAAAAAAAAAAAAAAAAAAAAAAAAAAAAAAAAAAAAAAAAAAAAJ/f38AWVlZA8zMzADAwP8Af39/AAAAAAAAAAAAAAAAAAAAAAAAAAAAIQAAABgAAAAUAAAAFAMAAM0AAAB/NwAAghAAABAAAAAmAAAACAAAAD0wAAAAAAAA"/>
               </a:ext>
             </a:extLst>
           </p:cNvSpPr>
@@ -10582,8 +10582,8 @@
         </p:nvSpPr>
         <p:spPr>
           <a:xfrm>
-            <a:off x="500380" y="703580"/>
-            <a:ext cx="8521065" cy="2585085"/>
+            <a:off x="500380" y="130175"/>
+            <a:ext cx="8521065" cy="2553335"/>
           </a:xfrm>
         </p:spPr>
         <p:txBody>
@@ -10657,7 +10657,7 @@
             <a:spLocks noGrp="1" noChangeArrowheads="1"/>
             <a:extLst>
               <a:ext uri="smNativeData">
-                <pr:smNativeData xmlns:pr="smNativeData" xmlns="smNativeData" val="SMDATA_15_FUV5ZhMAAAAlAAAAZAAAAA0AAAAAkAAAAJAAAACQAAAAkAAAAAAAAAAAAAAAAAAAAAEAAABQAAAAAAAAAAAA4D8AAAAAAADgPwAAAAAAAOA/AAAAAAAA4D8AAAAAAADgPwAAAAAAAOA/AAAAAAAA4D8AAAAAAADgPwAAAAAAAOA/AAAAAAAA4D8CAAAAjAAAAAAAAAAAAAAAQoX0DP///wgAAAAAAAAAAAAAAAAAAAAAAAAAAAAAAAAAAAAAZAAAAAEAAABAAAAAAAAAAAAAAAAAAAAAAAAAAAAAAAAAAAAAAAAAAAAAAAAAAAAAAAAAAAAAAAAAAAAAAAAAAAAAAAAAAAAAAAAAAAAAAAAAAAAAAAAAAAAAAAAAAAAAFAAAADwAAAAAAAAAAAAAAAAAAAkUAAAAAQAAABQAAAAUAAAAFAAAAAEAAAAAAAAAZAAAAGQAAAAAAAAAZAAAAGQAAAAVAAAAYAAAAAAAAAAAAAAADwAAACADAAAAAAAAAAAAAAEAAACgMgAAVgcAAKr4//8BAAAAf39/AAEAAABkAAAAAAAAABQAAABAHwAAAAAAACYAAAAAAAAAwOD//wAAAAAmAAAAZAAAABYAAABMAAAAAAAAAAAAAAAEAAAAAAAAAAEAAABZWVkKAAAAACgAAAAoAAAAZAAAAGQAAAAAAAAAzMzMAAAAAABQAAAAUAAAAGQAAABkAAAAAAAAABcAAAAUAAAAAAAAAAAAAAD/fwAA/38AAAAAAAAJAAAABAAAAMgN8V0eAAAAaAAAAAAAAAAAAAAAAAAAAAAAAAAAAAAAECcAABAnAAAAAAAAAAAAAAAAAAAAAAAAAAAAAAAAAAAAAAAAAAAAABQAAAAAAAAAwMD/AAAAAABkAAAAMgAAAAAAAABkAAAAAAAAAH9/fwAKAAAAIgAAABgAAAAAAAAAAAAAAAAAAAAAAAAAAAAAAAAAAAAkAAAAJAAAAAAAAAAHAAAAAAAAAAAAAAAAAAAAAAAAAAAAAAAAAAAAf39/ACUAAABYAAAAAAAAAAAAAAAAAAAAAAAAAAAAAAAAAAAAAAAAAAAAAAAAAAAAAAAAAAAAAAA/AAAAAAAAAKCGAQAAAAAAAAAAAAAAAAAMAAAAAQAAAAAAAAAAAAAAAAAAAB8AAABUAAAAQoX0Bf///wEAAAAAAAAAAAAAAAAAAAAAAAAAAAAAAAAAAAAAAAAAAAAAAAJ/f38AWVlZA8zMzADAwP8Af39/AAAAAAAAAAAAAAAAAAAAAAAAAAAAIQAAABgAAAAUAAAAShMAAK8ZAABQNwAAgB4AABAAAAAmAAAACAAAAD2wAAAAAAAA"/>
+                <pr:smNativeData xmlns:pr="smNativeData" xmlns="smNativeData" val="SMDATA_15_9kV5ZhMAAAAlAAAAZAAAAA0AAAAAkAAAAJAAAACQAAAAkAAAAAAAAAAAAAAAAAAAAAEAAABQAAAAAAAAAAAA4D8AAAAAAADgPwAAAAAAAOA/AAAAAAAA4D8AAAAAAADgPwAAAAAAAOA/AAAAAAAA4D8AAAAAAADgPwAAAAAAAOA/AAAAAAAA4D8CAAAAjAAAAAAAAAAAAAAAQoX0DP///wgAAAAAAAAAAAAAAAAAAAAAAAAAAAAAAAAAAAAAZAAAAAEAAABAAAAAAAAAAAAAAAAAAAAAAAAAAAAAAAAAAAAAAAAAAAAAAAAAAAAAAAAAAAAAAAAAAAAAAAAAAAAAAAAAAAAAAAAAAAAAAAAAAAAAAAAAAAAAAAAAAAAAFAAAADwAAAAAAAAAAAAAAAAAAAkUAAAAAQAAABQAAAAUAAAAFAAAAAEAAAAAAAAAZAAAAGQAAAAAAAAAZAAAAGQAAAAVAAAAYAAAAAAAAAAAAAAADwAAACADAAAAAAAAAAAAAAEAAACgMgAAVgcAAKr4//8BAAAAf39/AAEAAABkAAAAAAAAABQAAABAHwAAAAAAACYAAAAAAAAAwOD//wAAAAAmAAAAZAAAABYAAABMAAAAAAAAAAAAAAAEAAAAAAAAAAEAAABZWVkKAAAAACgAAAAoAAAAZAAAAGQAAAAAAAAAzMzMAAAAAABQAAAAUAAAAGQAAABkAAAAAAAAABcAAAAUAAAAAAAAAAAAAAD/fwAA/38AAAAAAAAJAAAABAAAAMgN8V0eAAAAaAAAAAAAAAAAAAAAAAAAAAAAAAAAAAAAECcAABAnAAAAAAAAAAAAAAAAAAAAAAAAAAAAAAAAAAAAAAAAAAAAABQAAAAAAAAAwMD/AAAAAABkAAAAMgAAAAAAAABkAAAAAAAAAH9/fwAKAAAAIgAAABgAAAAAAAAAAAAAAAAAAAAAAAAAAAAAAAAAAAAkAAAAJAAAAAAAAAAHAAAAAAAAAAAAAAAAAAAAAAAAAAAAAAAAAAAAf39/ACUAAABYAAAAAAAAAAAAAAAAAAAAAAAAAAAAAAAAAAAAAAAAAAAAAAAAAAAAAAAAAAAAAAA/AAAAAAAAAKCGAQAAAAAAAAAAAAAAAAAMAAAAAQAAAAAAAAAAAAAAAAAAAB8AAABUAAAAQoX0Bf///wEAAAAAAAAAAAAAAAAAAAAAAAAAAAAAAAAAAAAAAAAAAAAAAAJ/f38AWVlZA8zMzADAwP8Af39/AAAAAAAAAAAAAAAAAAAAAAAAAAAAIQAAABgAAAAUAAAAShMAAK8ZAABQNwAAgB4AABAAAAAmAAAACAAAAD2wAAAAAAAA"/>
               </a:ext>
             </a:extLst>
           </p:cNvSpPr>
@@ -10865,7 +10865,7 @@
             <a:spLocks noGrp="1" noChangeArrowheads="1"/>
             <a:extLst>
               <a:ext uri="smNativeData">
-                <pr:smNativeData xmlns:pr="smNativeData" xmlns="smNativeData" val="SMDATA_15_FUV5ZhMAAAAlAAAAZAAAAA0AAAAAkAAAAJAAAACQAAAAkAAAAAAAAAAAAAAAAAAAAAEAAABQAAAAAAAAAAAA4D8AAAAAAADgPwAAAAAAAOA/AAAAAAAA4D8AAAAAAADgPwAAAAAAAOA/AAAAAAAA4D8AAAAAAADgPwAAAAAAAOA/AAAAAAAA4D8CAAAAjAAAAAAAAAAAAAAAQoX0DP///wgAAAAAAAAAAAAAAAAAAAAAAAAAAAAAAAAAAAAAZAAAAAEAAABAAAAAAAAAAAAAAAAAAAAAAAAAAAAAAAAAAAAAAAAAAAAAAAAAAAAAAAAAAAAAAAAAAAAAAAAAAAAAAAAAAAAAAAAAAAAAAAAAAAAAAAAAAAAAAAAAAAAAFAAAADwAAAAAAAAAAAAAAAAAAAkUAAAAAQAAABQAAAAUAAAAFAAAAAEAAAAAAAAAZAAAAGQAAAAAAAAAZAAAAGQAAAAVAAAAYAAAAAAAAAAAAAAADwAAACADAAAAAAAAAAAAAAEAAACgMgAAVgcAAKr4//8BAAAAf39/AAEAAABkAAAAAAAAABQAAABAHwAAAAAAACYAAAAAAAAAwOD//wAAAAAmAAAAZAAAABYAAABMAAAAAAAAAAAAAAAEAAAAAAAAAAEAAABZWVkKAAAAACgAAAAoAAAAZAAAAGQAAAAAAAAAzMzMAAAAAABQAAAAUAAAAGQAAABkAAAAAAAAABcAAAAUAAAAAAAAAAAAAAD/fwAA/38AAAAAAAAJAAAABAAAAIscKB0eAAAAaAAAAAAAAAAAAAAAAAAAAAAAAAAAAAAAECcAABAnAAAAAAAAAAAAAAAAAAAAAAAAAAAAAAAAAAAAAAAAAAAAABQAAAAAAAAAwMD/AAAAAABkAAAAMgAAAAAAAABkAAAAAAAAAH9/fwAKAAAAIgAAABgAAAAAAAAAAAAAAAAAAAAAAAAAAAAAAAAAAAAkAAAAJAAAAAAAAAAHAAAAAAAAAAAAAAAAAAAAAAAAAAAAAAAAAAAAf39/ACUAAABYAAAAAAAAAAAAAAAAAAAAAAAAAAAAAAAAAAAAAAAAAAAAAAAAAAAAAAAAAAAAAAA/AAAAAAAAAKCGAQAAAAAAAAAAAAAAAAAMAAAAAQAAAAAAAAAAAAAAAAAAAB8AAABUAAAAQoX0Bf///wEAAAAAAAAAAAAAAAAAAAAAAAAAAAAAAAAAAAAAAAAAAAAAAAJ/f38AWVlZA8zMzADAwP8Af39/AAAAAAAAAAAAAAAAAAAAAAAAAAAAIQAAABgAAAAUAAAAShMAACUcAABQNwAApSIAABAAAAAmAAAACAAAAD0wAAAAAAAA"/>
+                <pr:smNativeData xmlns:pr="smNativeData" xmlns="smNativeData" val="SMDATA_15_9kV5ZhMAAAAlAAAAZAAAAA0AAAAAkAAAAJAAAACQAAAAkAAAAAAAAAAAAAAAAAAAAAEAAABQAAAAAAAAAAAA4D8AAAAAAADgPwAAAAAAAOA/AAAAAAAA4D8AAAAAAADgPwAAAAAAAOA/AAAAAAAA4D8AAAAAAADgPwAAAAAAAOA/AAAAAAAA4D8CAAAAjAAAAAAAAAAAAAAAQoX0DP///wgAAAAAAAAAAAAAAAAAAAAAAAAAAAAAAAAAAAAAZAAAAAEAAABAAAAAAAAAAAAAAAAAAAAAAAAAAAAAAAAAAAAAAAAAAAAAAAAAAAAAAAAAAAAAAAAAAAAAAAAAAAAAAAAAAAAAAAAAAAAAAAAAAAAAAAAAAAAAAAAAAAAAFAAAADwAAAAAAAAAAAAAAAAAAAkUAAAAAQAAABQAAAAUAAAAFAAAAAEAAAAAAAAAZAAAAGQAAAAAAAAAZAAAAGQAAAAVAAAAYAAAAAAAAAAAAAAADwAAACADAAAAAAAAAAAAAAEAAACgMgAAVgcAAKr4//8BAAAAf39/AAEAAABkAAAAAAAAABQAAABAHwAAAAAAACYAAAAAAAAAwOD//wAAAAAmAAAAZAAAABYAAABMAAAAAAAAAAAAAAAEAAAAAAAAAAEAAABZWVkKAAAAACgAAAAoAAAAZAAAAGQAAAAAAAAAzMzMAAAAAABQAAAAUAAAAGQAAABkAAAAAAAAABcAAAAUAAAAAAAAAAAAAAD/fwAA/38AAAAAAAAJAAAABAAAAIscKB0eAAAAaAAAAAAAAAAAAAAAAAAAAAAAAAAAAAAAECcAABAnAAAAAAAAAAAAAAAAAAAAAAAAAAAAAAAAAAAAAAAAAAAAABQAAAAAAAAAwMD/AAAAAABkAAAAMgAAAAAAAABkAAAAAAAAAH9/fwAKAAAAIgAAABgAAAAAAAAAAAAAAAAAAAAAAAAAAAAAAAAAAAAkAAAAJAAAAAAAAAAHAAAAAAAAAAAAAAAAAAAAAAAAAAAAAAAAAAAAf39/ACUAAABYAAAAAAAAAAAAAAAAAAAAAAAAAAAAAAAAAAAAAAAAAAAAAAAAAAAAAAAAAAAAAAA/AAAAAAAAAKCGAQAAAAAAAAAAAAAAAAAMAAAAAQAAAAAAAAAAAAAAAAAAAB8AAABUAAAAQoX0Bf///wEAAAAAAAAAAAAAAAAAAAAAAAAAAAAAAAAAAAAAAAAAAAAAAAJ/f38AWVlZA8zMzADAwP8Af39/AAAAAAAAAAAAAAAAAAAAAAAAAAAAIQAAABgAAAAUAAAAShMAACUcAABQNwAApSIAABAAAAAmAAAACAAAAD0wAAAAAAAA"/>
               </a:ext>
             </a:extLst>
           </p:cNvSpPr>
@@ -10911,7 +10911,7 @@
             <a:spLocks noGrp="1" noChangeArrowheads="1"/>
             <a:extLst>
               <a:ext uri="smNativeData">
-                <pr:smNativeData xmlns:pr="smNativeData" xmlns="smNativeData" val="SMDATA_15_FUV5ZhMAAAAlAAAAZAAAAA0AAAAAkAAAAJAAAACQAAAAkAAAAAAAAAAAAAAAAAAAAAEAAABQAAAAAAAAAAAA4D8AAAAAAADgPwAAAAAAAOA/AAAAAAAA4D8AAAAAAADgPwAAAAAAAOA/AAAAAAAA4D8AAAAAAADgPwAAAAAAAOA/AAAAAAAA4D8CAAAAjAAAAAAAAAAAAAAAQoX0DP///wgAAAAAAAAAAAAAAAAAAAAAAAAAAAAAAAAAAAAAZAAAAAEAAABAAAAAAAAAAAAAAAAAAAAAAAAAAAAAAAAAAAAAAAAAAAAAAAAAAAAAAAAAAAAAAAAAAAAAAAAAAAAAAAAAAAAAAAAAAAAAAAAAAAAAAAAAAAAAAAAAAAAAFAAAADwAAAAAAAAAAAAAAAAAAAkUAAAAAQAAABQAAAAUAAAAFAAAAAEAAAAAAAAAZAAAAGQAAAAAAAAAZAAAAGQAAAAVAAAAYAAAAAAAAAAAAAAADwAAACADAAAAAAAAAAAAAAEAAACgMgAAVgcAAKr4//8BAAAAf39/AAEAAABkAAAAAAAAABQAAABAHwAAAAAAACYAAAAAAAAAwOD//wAAAAAmAAAAZAAAABYAAABMAAAAAAAAAAAAAAAEAAAAAAAAAAEAAABZWVkKAAAAACgAAAAoAAAAZAAAAGQAAAAAAAAAzMzMAAAAAABQAAAAUAAAAGQAAABkAAAAAAAAABcAAAAUAAAAAAAAAAAAAAD/fwAA/38AAAAAAAAJAAAABAAAAG28P2UeAAAAaAAAAAAAAAAAAAAAAAAAAAAAAAAAAAAAECcAABAnAAAAAAAAAAAAAAAAAAAAAAAAAAAAAAAAAAAAAAAAAAAAABQAAAAAAAAAwMD/AAAAAABkAAAAMgAAAAAAAABkAAAAAAAAAH9/fwAKAAAAIgAAABgAAAAAAAAAAAAAAAAAAAAAAAAAAAAAAAAAAAAkAAAAJAAAAAAAAAAHAAAAAAAAAAAAAAAAAAAAAAAAAAAAAAAAAAAAf39/ACUAAABYAAAAAAAAAAAAAAAAAAAAAAAAAAAAAAAAAAAAAAAAAAAAAAAAAAAAAAAAAAAAAAA/AAAAAAAAAKCGAQAAAAAAAAAAAAAAAAAMAAAAAQAAAAAAAAAAAAAAAAAAAB8AAABUAAAAQoX0Bf///wEAAAAAAAAAAAAAAAAAAAAAAAAAAAAAAAAAAAAAAAAAAAAAAAJ/f38AWVlZA8zMzADAwP8Af39/AAAAAAAAAAAAAAAAAAAAAAAAAAAAIQAAABgAAAAUAAAAShMAACUdAABQNwAAniUAABAAAAAmAAAACAAAAD0wAAAAAAAA"/>
+                <pr:smNativeData xmlns:pr="smNativeData" xmlns="smNativeData" val="SMDATA_15_9kV5ZhMAAAAlAAAAZAAAAA0AAAAAkAAAAJAAAACQAAAAkAAAAAAAAAAAAAAAAAAAAAEAAABQAAAAAAAAAAAA4D8AAAAAAADgPwAAAAAAAOA/AAAAAAAA4D8AAAAAAADgPwAAAAAAAOA/AAAAAAAA4D8AAAAAAADgPwAAAAAAAOA/AAAAAAAA4D8CAAAAjAAAAAAAAAAAAAAAQoX0DP///wgAAAAAAAAAAAAAAAAAAAAAAAAAAAAAAAAAAAAAZAAAAAEAAABAAAAAAAAAAAAAAAAAAAAAAAAAAAAAAAAAAAAAAAAAAAAAAAAAAAAAAAAAAAAAAAAAAAAAAAAAAAAAAAAAAAAAAAAAAAAAAAAAAAAAAAAAAAAAAAAAAAAAFAAAADwAAAAAAAAAAAAAAAAAAAkUAAAAAQAAABQAAAAUAAAAFAAAAAEAAAAAAAAAZAAAAGQAAAAAAAAAZAAAAGQAAAAVAAAAYAAAAAAAAAAAAAAADwAAACADAAAAAAAAAAAAAAEAAACgMgAAVgcAAKr4//8BAAAAf39/AAEAAABkAAAAAAAAABQAAABAHwAAAAAAACYAAAAAAAAAwOD//wAAAAAmAAAAZAAAABYAAABMAAAAAAAAAAAAAAAEAAAAAAAAAAEAAABZWVkKAAAAACgAAAAoAAAAZAAAAGQAAAAAAAAAzMzMAAAAAABQAAAAUAAAAGQAAABkAAAAAAAAABcAAAAUAAAAAAAAAAAAAAD/fwAA/38AAAAAAAAJAAAABAAAAG28P2UeAAAAaAAAAAAAAAAAAAAAAAAAAAAAAAAAAAAAECcAABAnAAAAAAAAAAAAAAAAAAAAAAAAAAAAAAAAAAAAAAAAAAAAABQAAAAAAAAAwMD/AAAAAABkAAAAMgAAAAAAAABkAAAAAAAAAH9/fwAKAAAAIgAAABgAAAAAAAAAAAAAAAAAAAAAAAAAAAAAAAAAAAAkAAAAJAAAAAAAAAAHAAAAAAAAAAAAAAAAAAAAAAAAAAAAAAAAAAAAf39/ACUAAABYAAAAAAAAAAAAAAAAAAAAAAAAAAAAAAAAAAAAAAAAAAAAAAAAAAAAAAAAAAAAAAA/AAAAAAAAAKCGAQAAAAAAAAAAAAAAAAAMAAAAAQAAAAAAAAAAAAAAAAAAAB8AAABUAAAAQoX0Bf///wEAAAAAAAAAAAAAAAAAAAAAAAAAAAAAAAAAAAAAAAAAAAAAAAJ/f38AWVlZA8zMzADAwP8Af39/AAAAAAAAAAAAAAAAAAAAAAAAAAAAIQAAABgAAAAUAAAAShMAACUdAABQNwAAniUAABAAAAAmAAAACAAAAD0wAAAAAAAA"/>
               </a:ext>
             </a:extLst>
           </p:cNvSpPr>
@@ -10979,7 +10979,7 @@
             <a:picLocks noChangeAspect="1"/>
             <a:extLst>
               <a:ext uri="smNativeData">
-                <pr:smNativeData xmlns:pr="smNativeData" xmlns="smNativeData" val="SMDATA_17_FUV5ZhMAAAAlAAAAEQAAAC8BAAAAkAAAAEgAAACQAAAASAAAAAAAAAAAAAAAAAAAAAEAAABQAAAAAAAAAAAA4D8AAAAAAADgPwAAAAAAAOA/AAAAAAAA4D8AAAAAAADgPwAAAAAAAOA/AAAAAAAA4D8AAAAAAADgPwAAAAAAAOA/AAAAAAAA4D8CAAAAjAAAAAAAAAAAAAAAQoX0DP///wgAAAAAAAAAAAAAAAAAAAAAAAAAAAAAAAAAAAAAZAAAAAEAAABAAAAAAAAAAAAAAAAAAAAAAAAAAAAAAAAAAAAAAAAAAAAAAAAAAAAAAAAAAAAAAAAAAAAAAAAAAAAAAAAAAAAAAAAAAAAAAAAAAAAAAAAAAAAAAAAAAAAAFAAAADwAAAAAAAAAAAAAAAAAAAkUAAAAAQAAABQAAAAUAAAAFAAAAAEAAAAAAAAAZAAAAGQAAAAAAAAAZAAAAGQAAAAVAAAAYAAAAAAAAAAAAAAADwAAACADAAAAAAAAAAAAAAEAAACgMgAAVgcAAKr4//8BAAAAf39/AAEAAABkAAAAAAAAABQAAABAHwAAAAAAACYAAAAAAAAAwOD//wAAAAAmAAAAZAAAABYAAABMAAAAAAAAAAAAAAAEAAAAAAAAAAEAAABZWVkKAAAAACgAAAAoAAAAZAAAAGQAAAAAAAAAzMzMAAAAAABQAAAAUAAAAGQAAABkAAAAAAAAAAcAAAA4AAAAAAAAAAAAAAAAAAAA////AAAAAAAAAAAAAAAAAAAAAAAAAAAAAAAAAAAAAABkAAAAZAAAAAAAAAAjAAAABAAAAGQAAAAXAAAAFAAAAAAAAAAAAAAA/38AAP9/AAAAAAAACQAAAAQAAAAAAAAAHgAAAGgAAAAAAAAAAAAAAAAAAAAAAAAAAAAAABAnAAAQJwAAAAAAAAAAAAAAAAAAAAAAAAAAAAAAAAAAAAAAAAAAAAAUAAAAAAAAAMDA/wAAAAAAZAAAADIAAAAAAAAAZAAAAAAAAAB/f38ACgAAACIAAAAYAAAAAAAAAAAAAAAAAAAAAAAAAAAAAAAAAAAAJAAAACQAAAAAAAAABwAAAAAAAAAAAAAAAAAAAAAAAAAAAAAAAAAAAH9/fwAlAAAAWAAAAAAAAAAAAAAAAAAAAAAAAAAAAAAAAAAAAAAAAAAAAAAAAAAAAAAAAAAAAAAAPwAAAAAAAACghgEAAAAAAAAAAAAAAAAADAAAAAEAAAAAAAAAAAAAAAAAAAAfAAAAVAAAAEKF9AX///8BAAAAAAAAAAAAAAAAAAAAAAAAAAAAAAAAAAAAAAAAAAAAAAACf39/AFlZWQPMzMwAwMD/AH9/fwAAAAAAAAAAAAAAAAD///8AAAAAACEAAAAYAAAAFAAAAHgEAACpGAAA0Q4AAL8lAAAQAAAAJgAAAAgAAAD//////////w=="/>
+                <pr:smNativeData xmlns:pr="smNativeData" xmlns="smNativeData" val="SMDATA_17_9kV5ZhMAAAAlAAAAEQAAAC8BAAAAkAAAAEgAAACQAAAASAAAAAAAAAAAAAAAAAAAAAEAAABQAAAAAAAAAAAA4D8AAAAAAADgPwAAAAAAAOA/AAAAAAAA4D8AAAAAAADgPwAAAAAAAOA/AAAAAAAA4D8AAAAAAADgPwAAAAAAAOA/AAAAAAAA4D8CAAAAjAAAAAAAAAAAAAAAQoX0DP///wgAAAAAAAAAAAAAAAAAAAAAAAAAAAAAAAAAAAAAZAAAAAEAAABAAAAAAAAAAAAAAAAAAAAAAAAAAAAAAAAAAAAAAAAAAAAAAAAAAAAAAAAAAAAAAAAAAAAAAAAAAAAAAAAAAAAAAAAAAAAAAAAAAAAAAAAAAAAAAAAAAAAAFAAAADwAAAAAAAAAAAAAAAAAAAkUAAAAAQAAABQAAAAUAAAAFAAAAAEAAAAAAAAAZAAAAGQAAAAAAAAAZAAAAGQAAAAVAAAAYAAAAAAAAAAAAAAADwAAACADAAAAAAAAAAAAAAEAAACgMgAAVgcAAKr4//8BAAAAf39/AAEAAABkAAAAAAAAABQAAABAHwAAAAAAACYAAAAAAAAAwOD//wAAAAAmAAAAZAAAABYAAABMAAAAAAAAAAAAAAAEAAAAAAAAAAEAAABZWVkKAAAAACgAAAAoAAAAZAAAAGQAAAAAAAAAzMzMAAAAAABQAAAAUAAAAGQAAABkAAAAAAAAAAcAAAA4AAAAAAAAAAAAAAAAAAAA////AAAAAAAAAAAAAAAAAAAAAAAAAAAAAAAAAAAAAABkAAAAZAAAAAAAAAAjAAAABAAAAGQAAAAXAAAAFAAAAAAAAAAAAAAA/38AAP9/AAAAAAAACQAAAAQAAAAAAAAAHgAAAGgAAAAAAAAAAAAAAAAAAAAAAAAAAAAAABAnAAAQJwAAAAAAAAAAAAAAAAAAAAAAAAAAAAAAAAAAAAAAAAAAAAAUAAAAAAAAAMDA/wAAAAAAZAAAADIAAAAAAAAAZAAAAAAAAAB/f38ACgAAACIAAAAYAAAAAAAAAAAAAAAAAAAAAAAAAAAAAAAAAAAAJAAAACQAAAAAAAAABwAAAAAAAAAAAAAAAAAAAAAAAAAAAAAAAAAAAH9/fwAlAAAAWAAAAAAAAAAAAAAAAAAAAAAAAAAAAAAAAAAAAAAAAAAAAAAAAAAAAAAAAAAAAAAAPwAAAAAAAACghgEAAAAAAAAAAAAAAAAADAAAAAEAAAAAAAAAAAAAAAAAAAAfAAAAVAAAAEKF9AX///8BAAAAAAAAAAAAAAAAAAAAAAAAAAAAAAAAAAAAAAAAAAAAAAACf39/AFlZWQPMzMwAwMD/AH9/fwAAAAAAAAAAAAAAAAD///8AAAAAACEAAAAYAAAAFAAAAHgEAACpGAAA0Q4AAL8lAAAQAAAAJgAAAAgAAAD//////////w=="/>
               </a:ext>
             </a:extLst>
           </p:cNvPicPr>
@@ -11045,7 +11045,7 @@
             <a:spLocks noGrp="1" noChangeArrowheads="1"/>
             <a:extLst>
               <a:ext uri="smNativeData">
-                <pr:smNativeData xmlns:pr="smNativeData" xmlns="smNativeData" val="SMDATA_15_FUV5ZhMAAAAlAAAAZAAAAA0AAAAAkAAAAJAAAACQAAAAkAAAAAAAAAAAAAAAAAAAAAEAAABQAAAAAAAAAAAA4D8AAAAAAADgPwAAAAAAAOA/AAAAAAAA4D8AAAAAAADgPwAAAAAAAOA/AAAAAAAA4D8AAAAAAADgPwAAAAAAAOA/AAAAAAAA4D8CAAAAjAAAAAAAAAAAAAAAQoX0DP///wgAAAAAAAAAAAAAAAAAAAAAAAAAAAAAAAAAAAAAZAAAAAEAAABAAAAAAAAAAAAAAAAAAAAAAAAAAAAAAAAAAAAAAAAAAAAAAAAAAAAAAAAAAAAAAAAAAAAAAAAAAAAAAAAAAAAAAAAAAAAAAAAAAAAAAAAAAAAAAAAAAAAAFAAAADwAAAAAAAAAAAAAAAAAAAkUAAAAAQAAABQAAAAUAAAAFAAAAAEAAAAAAAAAZAAAAGQAAAAAAAAAZAAAAGQAAAAVAAAAYAAAAAAAAAAAAAAADwAAACADAAAAAAAAAAAAAAEAAACgMgAAVgcAAKr4//8BAAAAf39/AAEAAABkAAAAAAAAABQAAABAHwAAAAAAACYAAAAAAAAAwOD//wAAAAAmAAAAZAAAABYAAABMAAAAAAAAAAAAAAAEAAAAAAAAAAEAAABZWVkKAAAAACgAAAAoAAAAZAAAAGQAAAAAAAAAzMzMAAAAAABQAAAAUAAAAGQAAABkAAAAAAAAABcAAAAUAAAAAAAAAAAAAAD/fwAA/38AAAAAAAAJAAAABAAAAF8AYAAeAAAAaAAAAAAAAAAAAAAAAAAAAAAAAAAAAAAAECcAABAnAAAAAAAAAAAAAAAAAAAAAAAAAAAAAAAAAAAAAAAAAAAAABQAAAAAAAAAwMD/AAAAAABkAAAAMgAAAAAAAABkAAAAAAAAAH9/fwAKAAAAIgAAABgAAAAAAAAAAAAAAAAAAAAAAAAAAAAAAAAAAAAkAAAAJAAAAAAAAAAHAAAAAAAAAAAAAAAAAAAAAAAAAAAAAAAAAAAAf39/ACUAAABYAAAAAAAAAAAAAAAAAAAAAAAAAAAAAAAAAAAAAAAAAAAAAAAAAAAAAAAAAAAAAAA/AAAAAAAAAKCGAQAAAAAAAAAAAAAAAAAMAAAAAQAAAAAAAAAAAAAAAAAAAB8AAABUAAAAQoX0Bf///wEAAAAAAAAAAAAAAAAAAAAAAAAAAAAAAAAAAAAAAAAAAAAAAAJ/f38AWVlZA8zMzADAwP8Af39/AAAAAAAAAAAAAAAAAAAAAAAAAAAAIQAAABgAAAAUAAAAFAMAALYCAAB/NwAAVAcAABAAAAAmAAAACAAAAD0wAAAAAAAA"/>
+                <pr:smNativeData xmlns:pr="smNativeData" xmlns="smNativeData" val="SMDATA_15_9kV5ZhMAAAAlAAAAZAAAAA0AAAAAkAAAAJAAAACQAAAAkAAAAAAAAAAAAAAAAAAAAAEAAABQAAAAAAAAAAAA4D8AAAAAAADgPwAAAAAAAOA/AAAAAAAA4D8AAAAAAADgPwAAAAAAAOA/AAAAAAAA4D8AAAAAAADgPwAAAAAAAOA/AAAAAAAA4D8CAAAAjAAAAAAAAAAAAAAAQoX0DP///wgAAAAAAAAAAAAAAAAAAAAAAAAAAAAAAAAAAAAAZAAAAAEAAABAAAAAAAAAAAAAAAAAAAAAAAAAAAAAAAAAAAAAAAAAAAAAAAAAAAAAAAAAAAAAAAAAAAAAAAAAAAAAAAAAAAAAAAAAAAAAAAAAAAAAAAAAAAAAAAAAAAAAFAAAADwAAAAAAAAAAAAAAAAAAAkUAAAAAQAAABQAAAAUAAAAFAAAAAEAAAAAAAAAZAAAAGQAAAAAAAAAZAAAAGQAAAAVAAAAYAAAAAAAAAAAAAAADwAAACADAAAAAAAAAAAAAAEAAACgMgAAVgcAAKr4//8BAAAAf39/AAEAAABkAAAAAAAAABQAAABAHwAAAAAAACYAAAAAAAAAwOD//wAAAAAmAAAAZAAAABYAAABMAAAAAAAAAAAAAAAEAAAAAAAAAAEAAABZWVkKAAAAACgAAAAoAAAAZAAAAGQAAAAAAAAAzMzMAAAAAABQAAAAUAAAAGQAAABkAAAAAAAAABcAAAAUAAAAAAAAAAAAAAD/fwAA/38AAAAAAAAJAAAABAAAAF8AYAAeAAAAaAAAAAAAAAAAAAAAAAAAAAAAAAAAAAAAECcAABAnAAAAAAAAAAAAAAAAAAAAAAAAAAAAAAAAAAAAAAAAAAAAABQAAAAAAAAAwMD/AAAAAABkAAAAMgAAAAAAAABkAAAAAAAAAH9/fwAKAAAAIgAAABgAAAAAAAAAAAAAAAAAAAAAAAAAAAAAAAAAAAAkAAAAJAAAAAAAAAAHAAAAAAAAAAAAAAAAAAAAAAAAAAAAAAAAAAAAf39/ACUAAABYAAAAAAAAAAAAAAAAAAAAAAAAAAAAAAAAAAAAAAAAAAAAAAAAAAAAAAAAAAAAAAA/AAAAAAAAAKCGAQAAAAAAAAAAAAAAAAAMAAAAAQAAAAAAAAAAAAAAAAAAAB8AAABUAAAAAAAABQAAAAEAAAAAAAAAAAAAAAAAAAAAAAAAAAAAAAAAAAAAAAAAAAAAAAJ/f38AWVlZA8zMzADAwP8Af39/AAAAAAAAAAAAAAAAAAAAAAAAAAAAIQAAABgAAAAUAAAAFAMAALYCAAB/NwAAVAcAABAAAAAmAAAACAAAAD0wAAAAAAAA"/>
               </a:ext>
             </a:extLst>
           </p:cNvSpPr>
@@ -11090,7 +11090,7 @@
           <p:cNvSpPr>
             <a:extLst>
               <a:ext uri="smNativeData">
-                <pr:smNativeData xmlns:pr="smNativeData" xmlns="smNativeData" val="SMDATA_15_FUV5ZhMAAAAlAAAAZQAAAA0AAAAAqQEAAJAAAACpAQAAkAAAAAAAAAABAAAAAAAAAAEAAABQAAAAhbacS3FV1T8AAAAAAAAAAAAAAAAAAOA/AAAAAAAA4D8AAAAAAADgPwAAAAAAAOA/AAAAAAAA4D8AAAAAAADgPwAAAAAAAOA/AAAAAAAA4D8CAAAAjAAAAAEAAAAAAAAAi47jAP///wgAAAAAAAAAAAAAAAAAAAAAAAAAAAAAAAAAAAAAeAAAAAEAAABAAAAAAAAAAAAAAABaAAAAAAAAAAAAAAAAAAAAAAAAAAAAAAAAAAAAAAAAAAAAAAAAAAAAAAAAAAAAAAAAAAAAAAAAAAAAAAAAAAAAAAAAAAAAAAAAAAAAFAAAADwAAAAAAAAAAAAAAAAAAAkUAAAAAQAAABQAAAAUAAAAFAAAAAEAAAAAAAAAZAAAAGQAAAAAAAAAZAAAAGQAAAAVAAAAYAAAAAAAAAAAAAAADwAAACADAAAAAAAAAAAAAAEAAACgMgAAVgcAAKr4//8BAAAAf39/AAEAAABkAAAAAAAAABQAAABAHwAAAAAAACYAAAAAAAAAwOD//wAAAAAmAAAAZAAAABYAAABMAAAAAAAAAAAAAAAEAAAAAAAAAAEAAABZWVkKAAAAACgAAAAoAAAAZAAAAGQAAAAAAAAAzMzMAAAAAABQAAAAUAAAAGQAAABkAAAAAAAAABcAAAAUAAAAAAAAAAAAAAD/fwAA/38AAAAAAAAJAAAABAAAAEqKdAoeAAAAaAAAAAAAAAAAAAAAAAAAAAAAAAAAAAAAECcAABAnAAAAAAAAAAAAAAAAAAAAAAAAAAAAAAAAAAAAAAAAAAAAABQAAAAAAAAAwMD/AAAAAABkAAAAMgAAAAAAAABkAAAAAAAAAH9/fwAKAAAAIgAAABgAAAAAAAAAAAAAAAAAAAAAAAAAAAAAAAAAAAAkAAAAJAAAAAAAAAAHAAAAAAAAAAAAAAAAAAAAAAAAAAAAAAAAAAAAf39/ACUAAABYAAAAAAAAAAAAAAAAAAAAAAAAAAAAAAAAAAAAAAAAAAAAAAAAAAAAAAAAAAAAAAA/AAAAAAAAAKCGAQAAAAAAAAAAAAAAAAAMAAAAAQAAAAAAAAAAAAAAAAAAAB8AAABUAAAAi47jAP///wEAAAAAAAAAAAAAAAAAAAAAAAAAAAAAAAAAAAAAAAAAAAAAAAJ/f38AWVlZA8zMzADAwP8Af39/AAAAAAAAAAAAAAAAAAAAAAAAAAAAIQAAABgAAAAUAAAAMAQAAM0IAAADGQAA4wsAABAAAAAmAAAACAAAAP//////////"/>
+                <pr:smNativeData xmlns:pr="smNativeData" xmlns="smNativeData" val="SMDATA_15_9kV5ZhMAAAAlAAAAZQAAAA0AAAAAqQEAAJAAAACpAQAAkAAAAAAAAAABAAAAAAAAAAEAAABQAAAAhbacS3FV1T8AAAAAAAAAAAAAAAAAAOA/AAAAAAAA4D8AAAAAAADgPwAAAAAAAOA/AAAAAAAA4D8AAAAAAADgPwAAAAAAAOA/AAAAAAAA4D8CAAAAjAAAAAEAAAAAAAAAi47jAP///wgAAAAAAAAAAAAAAAAAAAAAAAAAAAAAAAAAAAAAeAAAAAEAAABAAAAAAAAAAAAAAABaAAAAAAAAAAAAAAAAAAAAAAAAAAAAAAAAAAAAAAAAAAAAAAAAAAAAAAAAAAAAAAAAAAAAAAAAAAAAAAAAAAAAAAAAAAAAAAAAAAAAFAAAADwAAAAAAAAAAAAAAAAAAAkUAAAAAQAAABQAAAAUAAAAFAAAAAEAAAAAAAAAZAAAAGQAAAAAAAAAZAAAAGQAAAAVAAAAYAAAAAAAAAAAAAAADwAAACADAAAAAAAAAAAAAAEAAACgMgAAVgcAAKr4//8BAAAAf39/AAEAAABkAAAAAAAAABQAAABAHwAAAAAAACYAAAAAAAAAwOD//wAAAAAmAAAAZAAAABYAAABMAAAAAAAAAAAAAAAEAAAAAAAAAAEAAABZWVkKAAAAACgAAAAoAAAAZAAAAGQAAAAAAAAAzMzMAAAAAABQAAAAUAAAAGQAAABkAAAAAAAAABcAAAAUAAAAAAAAAAAAAAD/fwAA/38AAAAAAAAJAAAABAAAAEqKdAoeAAAAaAAAAAAAAAAAAAAAAAAAAAAAAAAAAAAAECcAABAnAAAAAAAAAAAAAAAAAAAAAAAAAAAAAAAAAAAAAAAAAAAAABQAAAAAAAAAwMD/AAAAAABkAAAAMgAAAAAAAABkAAAAAAAAAH9/fwAKAAAAIgAAABgAAAAAAAAAAAAAAAAAAAAAAAAAAAAAAAAAAAAkAAAAJAAAAAAAAAAHAAAAAAAAAAAAAAAAAAAAAAAAAAAAAAAAAAAAf39/ACUAAABYAAAAAAAAAAAAAAAAAAAAAAAAAAAAAAAAAAAAAAAAAAAAAAAAAAAAAAAAAAAAAAA/AAAAAAAAAKCGAQAAAAAAAAAAAAAAAAAMAAAAAQAAAAAAAAAAAAAAAAAAAB8AAABUAAAAi47jAP///wEAAAAAAAAAAAAAAAAAAAAAAAAAAAAAAAAAAAAAAAAAAAAAAAJ/f38AWVlZA8zMzADAwP8Af39/AAAAAAAAAAAAAAAAAAAAAAAAAAAAIQAAABgAAAAUAAAAMAQAAM0IAAADGQAA4wsAABAAAAAmAAAACAAAAP//////////"/>
               </a:ext>
             </a:extLst>
           </p:cNvSpPr>
@@ -11155,7 +11155,7 @@
           <p:cNvSpPr>
             <a:extLst>
               <a:ext uri="smNativeData">
-                <pr:smNativeData xmlns:pr="smNativeData" xmlns="smNativeData" val="SMDATA_15_FUV5ZhMAAAAlAAAAZQAAAA0AAAAAqQEAAJAAAACpAQAAkAAAAAAAAAABAAAAAAAAAAEAAABQAAAAhbacS3FV1T8AAAAAAAAAAAAAAAAAAOA/AAAAAAAA4D8AAAAAAADgPwAAAAAAAOA/AAAAAAAA4D8AAAAAAADgPwAAAAAAAOA/AAAAAAAA4D8CAAAAjAAAAAEAAAAAAAAAi47jAP///wgAAAAAAAAAAAAAAAAAAAAAAAAAAAAAAAAAAAAAeAAAAAEAAABAAAAAAAAAAAAAAABaAAAAAAAAAAAAAAAAAAAAAAAAAAAAAAAAAAAAAAAAAAAAAAAAAAAAAAAAAAAAAAAAAAAAAAAAAAAAAAAAAAAAAAAAAAAAAAAAAAAAFAAAADwAAAAAAAAAAAAAAAAAAAkUAAAAAQAAABQAAAAUAAAAFAAAAAEAAAAAAAAAZAAAAGQAAAAAAAAAZAAAAGQAAAAVAAAAYAAAAAAAAAAAAAAADwAAACADAAAAAAAAAAAAAAEAAACgMgAAVgcAAKr4//8BAAAAf39/AAEAAABkAAAAAAAAABQAAABAHwAAAAAAACYAAAAAAAAAwOD//wAAAAAmAAAAZAAAABYAAABMAAAAAAAAAAAAAAAEAAAAAAAAAAEAAABZWVkKAAAAACgAAAAoAAAAZAAAAGQAAAAAAAAAzMzMAAAAAABQAAAAUAAAAGQAAABkAAAAAAAAABcAAAAUAAAAAAAAAAAAAAD/fwAA/38AAAAAAAAJAAAABAAAAMdydoweAAAAaAAAAAAAAAAAAAAAAAAAAAAAAAAAAAAAECcAABAnAAAAAAAAAAAAAAAAAAAAAAAAAAAAAAAAAAAAAAAAAAAAABQAAAAAAAAAwMD/AAAAAABkAAAAMgAAAAAAAABkAAAAAAAAAH9/fwAKAAAAIgAAABgAAAAAAAAAAAAAAAAAAAAAAAAAAAAAAAAAAAAkAAAAJAAAAAAAAAAHAAAAAAAAAAAAAAAAAAAAAAAAAAAAAAAAAAAAf39/ACUAAABYAAAAAAAAAAAAAAAAAAAAAAAAAAAAAAAAAAAAAAAAAAAAAAAAAAAAAAAAAAAAAAA/AAAAAAAAAKCGAQAAAAAAAAAAAAAAAAAMAAAAAQAAAAAAAAAAAAAAAAAAAB8AAABUAAAAi47jAP///wEAAAAAAAAAAAAAAAAAAAAAAAAAAAAAAAAAAAAAAAAAAAAAAAJ/f38AWVlZA8zMzADAwP8Af39/AAAAAAAAAAAAAAAAAAAAAAAAAAAAIQAAABgAAAAUAAAAMAQAAN4NAAADGQAA9BAAABAAAAAmAAAACAAAAP//////////"/>
+                <pr:smNativeData xmlns:pr="smNativeData" xmlns="smNativeData" val="SMDATA_15_9kV5ZhMAAAAlAAAAZQAAAA0AAAAAqQEAAJAAAACpAQAAkAAAAAAAAAABAAAAAAAAAAEAAABQAAAAhbacS3FV1T8AAAAAAAAAAAAAAAAAAOA/AAAAAAAA4D8AAAAAAADgPwAAAAAAAOA/AAAAAAAA4D8AAAAAAADgPwAAAAAAAOA/AAAAAAAA4D8CAAAAjAAAAAEAAAAAAAAAi47jAP///wgAAAAAAAAAAAAAAAAAAAAAAAAAAAAAAAAAAAAAeAAAAAEAAABAAAAAAAAAAAAAAABaAAAAAAAAAAAAAAAAAAAAAAAAAAAAAAAAAAAAAAAAAAAAAAAAAAAAAAAAAAAAAAAAAAAAAAAAAAAAAAAAAAAAAAAAAAAAAAAAAAAAFAAAADwAAAAAAAAAAAAAAAAAAAkUAAAAAQAAABQAAAAUAAAAFAAAAAEAAAAAAAAAZAAAAGQAAAAAAAAAZAAAAGQAAAAVAAAAYAAAAAAAAAAAAAAADwAAACADAAAAAAAAAAAAAAEAAACgMgAAVgcAAKr4//8BAAAAf39/AAEAAABkAAAAAAAAABQAAABAHwAAAAAAACYAAAAAAAAAwOD//wAAAAAmAAAAZAAAABYAAABMAAAAAAAAAAAAAAAEAAAAAAAAAAEAAABZWVkKAAAAACgAAAAoAAAAZAAAAGQAAAAAAAAAzMzMAAAAAABQAAAAUAAAAGQAAABkAAAAAAAAABcAAAAUAAAAAAAAAAAAAAD/fwAA/38AAAAAAAAJAAAABAAAAMdydoweAAAAaAAAAAAAAAAAAAAAAAAAAAAAAAAAAAAAECcAABAnAAAAAAAAAAAAAAAAAAAAAAAAAAAAAAAAAAAAAAAAAAAAABQAAAAAAAAAwMD/AAAAAABkAAAAMgAAAAAAAABkAAAAAAAAAH9/fwAKAAAAIgAAABgAAAAAAAAAAAAAAAAAAAAAAAAAAAAAAAAAAAAkAAAAJAAAAAAAAAAHAAAAAAAAAAAAAAAAAAAAAAAAAAAAAAAAAAAAf39/ACUAAABYAAAAAAAAAAAAAAAAAAAAAAAAAAAAAAAAAAAAAAAAAAAAAAAAAAAAAAAAAAAAAAA/AAAAAAAAAKCGAQAAAAAAAAAAAAAAAAAMAAAAAQAAAAAAAAAAAAAAAAAAAB8AAABUAAAAi47jAP///wEAAAAAAAAAAAAAAAAAAAAAAAAAAAAAAAAAAAAAAAAAAAAAAAJ/f38AWVlZA8zMzADAwP8Af39/AAAAAAAAAAAAAAAAAAAAAAAAAAAAIQAAABgAAAAUAAAAMAQAAN4NAAADGQAA9BAAABAAAAAmAAAACAAAAP//////////"/>
               </a:ext>
             </a:extLst>
           </p:cNvSpPr>
@@ -11220,7 +11220,7 @@
           <p:cNvSpPr>
             <a:extLst>
               <a:ext uri="smNativeData">
-                <pr:smNativeData xmlns:pr="smNativeData" xmlns="smNativeData" val="SMDATA_15_FUV5ZhMAAAAlAAAAZQAAAA0AAAAAqQEAAJAAAACpAQAAkAAAAAAAAAABAAAAAAAAAAEAAABQAAAAhbacS3FV1T8AAAAAAAAAAAAAAAAAAOA/AAAAAAAA4D8AAAAAAADgPwAAAAAAAOA/AAAAAAAA4D8AAAAAAADgPwAAAAAAAOA/AAAAAAAA4D8CAAAAjAAAAAEAAAAAAAAAi47jAP///wgAAAAAAAAAAAAAAAAAAAAAAAAAAAAAAAAAAAAAeAAAAAEAAABAAAAAAAAAAAAAAABaAAAAAAAAAAAAAAAAAAAAAAAAAAAAAAAAAAAAAAAAAAAAAAAAAAAAAAAAAAAAAAAAAAAAAAAAAAAAAAAAAAAAAAAAAAAAAAAAAAAAFAAAADwAAAAAAAAAAAAAAAAAAAkUAAAAAQAAABQAAAAUAAAAFAAAAAEAAAAAAAAAZAAAAGQAAAAAAAAAZAAAAGQAAAAVAAAAYAAAAAAAAAAAAAAADwAAACADAAAAAAAAAAAAAAEAAACgMgAAVgcAAKr4//8BAAAAf39/AAEAAABkAAAAAAAAABQAAABAHwAAAAAAACYAAAAAAAAAwOD//wAAAAAmAAAAZAAAABYAAABMAAAAAAAAAAAAAAAEAAAAAAAAAAEAAABZWVkKAAAAACgAAAAoAAAAZAAAAGQAAAAAAAAAzMzMAAAAAABQAAAAUAAAAGQAAABkAAAAAAAAABcAAAAUAAAAAAAAAAAAAAD/fwAA/38AAAAAAAAJAAAABAAAAE554FYeAAAAaAAAAAAAAAAAAAAAAAAAAAAAAAAAAAAAECcAABAnAAAAAAAAAAAAAAAAAAAAAAAAAAAAAAAAAAAAAAAAAAAAABQAAAAAAAAAwMD/AAAAAABkAAAAMgAAAAAAAABkAAAAAAAAAH9/fwAKAAAAIgAAABgAAAAAAAAAAAAAAAAAAAAAAAAAAAAAAAAAAAAkAAAAJAAAAAAAAAAHAAAAAAAAAAAAAAAAAAAAAAAAAAAAAAAAAAAAf39/ACUAAABYAAAAAAAAAAAAAAAAAAAAAAAAAAAAAAAAAAAAAAAAAAAAAAAAAAAAAAAAAAAAAAA/AAAAAAAAAKCGAQAAAAAAAAAAAAAAAAAMAAAAAQAAAAAAAAAAAAAAAAAAAB8AAABUAAAAi47jAP///wEAAAAAAAAAAAAAAAAAAAAAAAAAAAAAAAAAAAAAAAAAAAAAAAJ/f38AWVlZA8zMzADAwP8Af39/AAAAAAAAAAAAAAAAAAAAAAAAAAAAIQAAABgAAAAUAAAAMAQAAAQTAAADGQAAGhYAABAAAAAmAAAACAAAAP//////////"/>
+                <pr:smNativeData xmlns:pr="smNativeData" xmlns="smNativeData" val="SMDATA_15_9kV5ZhMAAAAlAAAAZQAAAA0AAAAAqQEAAJAAAACpAQAAkAAAAAAAAAABAAAAAAAAAAEAAABQAAAAhbacS3FV1T8AAAAAAAAAAAAAAAAAAOA/AAAAAAAA4D8AAAAAAADgPwAAAAAAAOA/AAAAAAAA4D8AAAAAAADgPwAAAAAAAOA/AAAAAAAA4D8CAAAAjAAAAAEAAAAAAAAAi47jAP///wgAAAAAAAAAAAAAAAAAAAAAAAAAAAAAAAAAAAAAeAAAAAEAAABAAAAAAAAAAAAAAABaAAAAAAAAAAAAAAAAAAAAAAAAAAAAAAAAAAAAAAAAAAAAAAAAAAAAAAAAAAAAAAAAAAAAAAAAAAAAAAAAAAAAAAAAAAAAAAAAAAAAFAAAADwAAAAAAAAAAAAAAAAAAAkUAAAAAQAAABQAAAAUAAAAFAAAAAEAAAAAAAAAZAAAAGQAAAAAAAAAZAAAAGQAAAAVAAAAYAAAAAAAAAAAAAAADwAAACADAAAAAAAAAAAAAAEAAACgMgAAVgcAAKr4//8BAAAAf39/AAEAAABkAAAAAAAAABQAAABAHwAAAAAAACYAAAAAAAAAwOD//wAAAAAmAAAAZAAAABYAAABMAAAAAAAAAAAAAAAEAAAAAAAAAAEAAABZWVkKAAAAACgAAAAoAAAAZAAAAGQAAAAAAAAAzMzMAAAAAABQAAAAUAAAAGQAAABkAAAAAAAAABcAAAAUAAAAAAAAAAAAAAD/fwAA/38AAAAAAAAJAAAABAAAAE554FYeAAAAaAAAAAAAAAAAAAAAAAAAAAAAAAAAAAAAECcAABAnAAAAAAAAAAAAAAAAAAAAAAAAAAAAAAAAAAAAAAAAAAAAABQAAAAAAAAAwMD/AAAAAABkAAAAMgAAAAAAAABkAAAAAAAAAH9/fwAKAAAAIgAAABgAAAAAAAAAAAAAAAAAAAAAAAAAAAAAAAAAAAAkAAAAJAAAAAAAAAAHAAAAAAAAAAAAAAAAAAAAAAAAAAAAAAAAAAAAf39/ACUAAABYAAAAAAAAAAAAAAAAAAAAAAAAAAAAAAAAAAAAAAAAAAAAAAAAAAAAAAAAAAAAAAA/AAAAAAAAAKCGAQAAAAAAAAAAAAAAAAAMAAAAAQAAAAAAAAAAAAAAAAAAAB8AAABUAAAAi47jAP///wEAAAAAAAAAAAAAAAAAAAAAAAAAAAAAAAAAAAAAAAAAAAAAAAJ/f38AWVlZA8zMzADAwP8Af39/AAAAAAAAAAAAAAAAAAAAAAAAAAAAIQAAABgAAAAUAAAAMAQAAAQTAAADGQAAGhYAABAAAAAmAAAACAAAAP//////////"/>
               </a:ext>
             </a:extLst>
           </p:cNvSpPr>
@@ -11285,7 +11285,7 @@
           <p:cNvSpPr>
             <a:extLst>
               <a:ext uri="smNativeData">
-                <pr:smNativeData xmlns:pr="smNativeData" xmlns="smNativeData" val="SMDATA_15_FUV5ZhMAAAAlAAAAZQAAAA0AAAAAqQEAAJAAAACpAQAAkAAAAAAAAAABAAAAAAAAAAEAAABQAAAAhbacS3FV1T8AAAAAAAAAAAAAAAAAAOA/AAAAAAAA4D8AAAAAAADgPwAAAAAAAOA/AAAAAAAA4D8AAAAAAADgPwAAAAAAAOA/AAAAAAAA4D8CAAAAjAAAAAEAAAAAAAAAi47jAP///wgAAAAAAAAAAAAAAAAAAAAAAAAAAAAAAAAAAAAAeAAAAAEAAABAAAAAAAAAAAAAAABaAAAAAAAAAAAAAAAAAAAAAAAAAAAAAAAAAAAAAAAAAAAAAAAAAAAAAAAAAAAAAAAAAAAAAAAAAAAAAAAAAAAAAAAAAAAAAAAAAAAAFAAAADwAAAAAAAAAAAAAAAAAAAkUAAAAAQAAABQAAAAUAAAAFAAAAAEAAAAAAAAAZAAAAGQAAAAAAAAAZAAAAGQAAAAVAAAAYAAAAAAAAAAAAAAADwAAACADAAAAAAAAAAAAAAEAAACgMgAAVgcAAKr4//8BAAAAf39/AAEAAABkAAAAAAAAABQAAABAHwAAAAAAACYAAAAAAAAAwOD//wAAAAAmAAAAZAAAABYAAABMAAAAAAAAAAAAAAAEAAAAAAAAAAEAAABZWVkKAAAAACgAAAAoAAAAZAAAAGQAAAAAAAAAzMzMAAAAAABQAAAAUAAAAGQAAABkAAAAAAAAABcAAAAUAAAAAAAAAAAAAAD/fwAA/38AAAAAAAAJAAAABAAAAARNBpkeAAAAaAAAAAAAAAAAAAAAAAAAAAAAAAAAAAAAECcAABAnAAAAAAAAAAAAAAAAAAAAAAAAAAAAAAAAAAAAAAAAAAAAABQAAAAAAAAAwMD/AAAAAABkAAAAMgAAAAAAAABkAAAAAAAAAH9/fwAKAAAAIgAAABgAAAAAAAAAAAAAAAAAAAAAAAAAAAAAAAAAAAAkAAAAJAAAAAAAAAAHAAAAAAAAAAAAAAAAAAAAAAAAAAAAAAAAAAAAf39/ACUAAABYAAAAAAAAAAAAAAAAAAAAAAAAAAAAAAAAAAAAAAAAAAAAAAAAAAAAAAAAAAAAAAA/AAAAAAAAAKCGAQAAAAAAAAAAAAAAAAAMAAAAAQAAAAAAAAAAAAAAAAAAAB8AAABUAAAAi47jAP///wEAAAAAAAAAAAAAAAAAAAAAAAAAAAAAAAAAAAAAAAAAAAAAAAJ/f38AWVlZA8zMzADAwP8Af39/AAAAAAAAAAAAAAAAAAAAAAAAAAAAIQAAABgAAAAUAAAAMAQAACoYAAADGQAAQBsAABAAAAAmAAAACAAAAP//////////"/>
+                <pr:smNativeData xmlns:pr="smNativeData" xmlns="smNativeData" val="SMDATA_15_9kV5ZhMAAAAlAAAAZQAAAA0AAAAAqQEAAJAAAACpAQAAkAAAAAAAAAABAAAAAAAAAAEAAABQAAAAhbacS3FV1T8AAAAAAAAAAAAAAAAAAOA/AAAAAAAA4D8AAAAAAADgPwAAAAAAAOA/AAAAAAAA4D8AAAAAAADgPwAAAAAAAOA/AAAAAAAA4D8CAAAAjAAAAAEAAAAAAAAAi47jAP///wgAAAAAAAAAAAAAAAAAAAAAAAAAAAAAAAAAAAAAeAAAAAEAAABAAAAAAAAAAAAAAABaAAAAAAAAAAAAAAAAAAAAAAAAAAAAAAAAAAAAAAAAAAAAAAAAAAAAAAAAAAAAAAAAAAAAAAAAAAAAAAAAAAAAAAAAAAAAAAAAAAAAFAAAADwAAAAAAAAAAAAAAAAAAAkUAAAAAQAAABQAAAAUAAAAFAAAAAEAAAAAAAAAZAAAAGQAAAAAAAAAZAAAAGQAAAAVAAAAYAAAAAAAAAAAAAAADwAAACADAAAAAAAAAAAAAAEAAACgMgAAVgcAAKr4//8BAAAAf39/AAEAAABkAAAAAAAAABQAAABAHwAAAAAAACYAAAAAAAAAwOD//wAAAAAmAAAAZAAAABYAAABMAAAAAAAAAAAAAAAEAAAAAAAAAAEAAABZWVkKAAAAACgAAAAoAAAAZAAAAGQAAAAAAAAAzMzMAAAAAABQAAAAUAAAAGQAAABkAAAAAAAAABcAAAAUAAAAAAAAAAAAAAD/fwAA/38AAAAAAAAJAAAABAAAAARNBpkeAAAAaAAAAAAAAAAAAAAAAAAAAAAAAAAAAAAAECcAABAnAAAAAAAAAAAAAAAAAAAAAAAAAAAAAAAAAAAAAAAAAAAAABQAAAAAAAAAwMD/AAAAAABkAAAAMgAAAAAAAABkAAAAAAAAAH9/fwAKAAAAIgAAABgAAAAAAAAAAAAAAAAAAAAAAAAAAAAAAAAAAAAkAAAAJAAAAAAAAAAHAAAAAAAAAAAAAAAAAAAAAAAAAAAAAAAAAAAAf39/ACUAAABYAAAAAAAAAAAAAAAAAAAAAAAAAAAAAAAAAAAAAAAAAAAAAAAAAAAAAAAAAAAAAAA/AAAAAAAAAKCGAQAAAAAAAAAAAAAAAAAMAAAAAQAAAAAAAAAAAAAAAAAAAB8AAABUAAAAi47jAP///wEAAAAAAAAAAAAAAAAAAAAAAAAAAAAAAAAAAAAAAAAAAAAAAAJ/f38AWVlZA8zMzADAwP8Af39/AAAAAAAAAAAAAAAAAAAAAAAAAAAAIQAAABgAAAAUAAAAMAQAACoYAAADGQAAQBsAABAAAAAmAAAACAAAAP//////////"/>
               </a:ext>
             </a:extLst>
           </p:cNvSpPr>
@@ -11350,7 +11350,7 @@
           <p:cNvSpPr>
             <a:extLst>
               <a:ext uri="smNativeData">
-                <pr:smNativeData xmlns:pr="smNativeData" xmlns="smNativeData" val="SMDATA_15_FUV5ZhMAAAAlAAAAZQAAAA0AAAAAqQEAAJAAAACpAQAAkAAAAAAAAAABAAAAAAAAAAEAAABQAAAAhbacS3FV1T8AAAAAAAAAAAAAAAAAAOA/AAAAAAAA4D8AAAAAAADgPwAAAAAAAOA/AAAAAAAA4D8AAAAAAADgPwAAAAAAAOA/AAAAAAAA4D8CAAAAjAAAAAEAAAAAAAAAi47jAP///wgAAAAAAAAAAAAAAAAAAAAAAAAAAAAAAAAAAAAAeAAAAAEAAABAAAAAAAAAAAAAAABaAAAAAAAAAAAAAAAAAAAAAAAAAAAAAAAAAAAAAAAAAAAAAAAAAAAAAAAAAAAAAAAAAAAAAAAAAAAAAAAAAAAAAAAAAAAAAAAAAAAAFAAAADwAAAAAAAAAAAAAAAAAAAkUAAAAAQAAABQAAAAUAAAAFAAAAAEAAAAAAAAAZAAAAGQAAAAAAAAAZAAAAGQAAAAVAAAAYAAAAAAAAAAAAAAADwAAACADAAAAAAAAAAAAAAEAAACgMgAAVgcAAKr4//8BAAAAf39/AAEAAABkAAAAAAAAABQAAABAHwAAAAAAACYAAAAAAAAAwOD//wAAAAAmAAAAZAAAABYAAABMAAAAAAAAAAAAAAAEAAAAAAAAAAEAAABZWVkKAAAAACgAAAAoAAAAZAAAAGQAAAAAAAAAzMzMAAAAAABQAAAAUAAAAGQAAABkAAAAAAAAABcAAAAUAAAAAAAAAAAAAAD/fwAA/38AAAAAAAAJAAAABAAAAFQBpU4eAAAAaAAAAAAAAAAAAAAAAAAAAAAAAAAAAAAAECcAABAnAAAAAAAAAAAAAAAAAAAAAAAAAAAAAAAAAAAAAAAAAAAAABQAAAAAAAAAwMD/AAAAAABkAAAAMgAAAAAAAABkAAAAAAAAAH9/fwAKAAAAIgAAABgAAAAAAAAAAAAAAAAAAAAAAAAAAAAAAAAAAAAkAAAAJAAAAAAAAAAHAAAAAAAAAAAAAAAAAAAAAAAAAAAAAAAAAAAAf39/ACUAAABYAAAAAAAAAAAAAAAAAAAAAAAAAAAAAAAAAAAAAAAAAAAAAAAAAAAAAAAAAAAAAAA/AAAAAAAAAKCGAQAAAAAAAAAAAAAAAAAMAAAAAQAAAAAAAAAAAAAAAAAAAB8AAABUAAAAi47jAP///wEAAAAAAAAAAAAAAAAAAAAAAAAAAAAAAAAAAAAAAAAAAAAAAAJ/f38AWVlZA8zMzADAwP8Af39/AAAAAAAAAAAAAAAAAAAAAAAAAAAAIQAAABgAAAAUAAAAMAQAAPkcAAADGQAADyAAABAAAAAmAAAACAAAAP//////////"/>
+                <pr:smNativeData xmlns:pr="smNativeData" xmlns="smNativeData" val="SMDATA_15_9kV5ZhMAAAAlAAAAZQAAAA0AAAAAqQEAAJAAAACpAQAAkAAAAAAAAAABAAAAAAAAAAEAAABQAAAAhbacS3FV1T8AAAAAAAAAAAAAAAAAAOA/AAAAAAAA4D8AAAAAAADgPwAAAAAAAOA/AAAAAAAA4D8AAAAAAADgPwAAAAAAAOA/AAAAAAAA4D8CAAAAjAAAAAEAAAAAAAAAi47jAP///wgAAAAAAAAAAAAAAAAAAAAAAAAAAAAAAAAAAAAAeAAAAAEAAABAAAAAAAAAAAAAAABaAAAAAAAAAAAAAAAAAAAAAAAAAAAAAAAAAAAAAAAAAAAAAAAAAAAAAAAAAAAAAAAAAAAAAAAAAAAAAAAAAAAAAAAAAAAAAAAAAAAAFAAAADwAAAAAAAAAAAAAAAAAAAkUAAAAAQAAABQAAAAUAAAAFAAAAAEAAAAAAAAAZAAAAGQAAAAAAAAAZAAAAGQAAAAVAAAAYAAAAAAAAAAAAAAADwAAACADAAAAAAAAAAAAAAEAAACgMgAAVgcAAKr4//8BAAAAf39/AAEAAABkAAAAAAAAABQAAABAHwAAAAAAACYAAAAAAAAAwOD//wAAAAAmAAAAZAAAABYAAABMAAAAAAAAAAAAAAAEAAAAAAAAAAEAAABZWVkKAAAAACgAAAAoAAAAZAAAAGQAAAAAAAAAzMzMAAAAAABQAAAAUAAAAGQAAABkAAAAAAAAABcAAAAUAAAAAAAAAAAAAAD/fwAA/38AAAAAAAAJAAAABAAAAFQBpU4eAAAAaAAAAAAAAAAAAAAAAAAAAAAAAAAAAAAAECcAABAnAAAAAAAAAAAAAAAAAAAAAAAAAAAAAAAAAAAAAAAAAAAAABQAAAAAAAAAwMD/AAAAAABkAAAAMgAAAAAAAABkAAAAAAAAAH9/fwAKAAAAIgAAABgAAAAAAAAAAAAAAAAAAAAAAAAAAAAAAAAAAAAkAAAAJAAAAAAAAAAHAAAAAAAAAAAAAAAAAAAAAAAAAAAAAAAAAAAAf39/ACUAAABYAAAAAAAAAAAAAAAAAAAAAAAAAAAAAAAAAAAAAAAAAAAAAAAAAAAAAAAAAAAAAAA/AAAAAAAAAKCGAQAAAAAAAAAAAAAAAAAMAAAAAQAAAAAAAAAAAAAAAAAAAB8AAABUAAAAi47jAP///wEAAAAAAAAAAAAAAAAAAAAAAAAAAAAAAAAAAAAAAAAAAAAAAAJ/f38AWVlZA8zMzADAwP8Af39/AAAAAAAAAAAAAAAAAAAAAAAAAAAAIQAAABgAAAAUAAAAMAQAAPkcAAADGQAADyAAABAAAAAmAAAACAAAAP//////////"/>
               </a:ext>
             </a:extLst>
           </p:cNvSpPr>
@@ -11415,7 +11415,7 @@
           <p:cNvSpPr>
             <a:extLst>
               <a:ext uri="smNativeData">
-                <pr:smNativeData xmlns:pr="smNativeData" xmlns="smNativeData" val="SMDATA_15_FUV5ZhMAAAAlAAAAZQAAAA0AAAAAqQEAAJAAAACpAQAAkAAAAAAAAAABAAAAAAAAAAEAAABQAAAAhbacS3FV1T8AAAAAAAAAAAAAAAAAAOA/AAAAAAAA4D8AAAAAAADgPwAAAAAAAOA/AAAAAAAA4D8AAAAAAADgPwAAAAAAAOA/AAAAAAAA4D8CAAAAjAAAAAEAAAAAAAAAi47jAP///wgAAAAAAAAAAAAAAAAAAAAAAAAAAAAAAAAAAAAAeAAAAAEAAABAAAAAAAAAAAAAAABaAAAAAAAAAAAAAAAAAAAAAAAAAAAAAAAAAAAAAAAAAAAAAAAAAAAAAAAAAAAAAAAAAAAAAAAAAAAAAAAAAAAAAAAAAAAAAAAAAAAAFAAAADwAAAAAAAAAAAAAAAAAAAkUAAAAAQAAABQAAAAUAAAAFAAAAAEAAAAAAAAAZAAAAGQAAAAAAAAAZAAAAGQAAAAVAAAAYAAAAAAAAAAAAAAADwAAACADAAAAAAAAAAAAAAEAAACgMgAAVgcAAKr4//8BAAAAf39/AAEAAABkAAAAAAAAABQAAABAHwAAAAAAACYAAAAAAAAAwOD//wAAAAAmAAAAZAAAABYAAABMAAAAAAAAAAAAAAAEAAAAAAAAAAEAAABZWVkKAAAAACgAAAAoAAAAZAAAAGQAAAAAAAAAzMzMAAAAAABQAAAAUAAAAGQAAABkAAAAAAAAABcAAAAUAAAAAAAAAAAAAAD/fwAA/38AAAAAAAAJAAAABAAAACOg4r4eAAAAaAAAAAAAAAAAAAAAAAAAAAAAAAAAAAAAECcAABAnAAAAAAAAAAAAAAAAAAAAAAAAAAAAAAAAAAAAAAAAAAAAABQAAAAAAAAAwMD/AAAAAABkAAAAMgAAAAAAAABkAAAAAAAAAH9/fwAKAAAAIgAAABgAAAAAAAAAAAAAAAAAAAAAAAAAAAAAAAAAAAAkAAAAJAAAAAAAAAAHAAAAAAAAAAAAAAAAAAAAAAAAAAAAAAAAAAAAf39/ACUAAABYAAAAAAAAAAAAAAAAAAAAAAAAAAAAAAAAAAAAAAAAAAAAAAAAAAAAAAAAAAAAAAA/AAAAAAAAAKCGAQAAAAAAAAAAAAAAAAAMAAAAAQAAAAAAAAAAAAAAAAAAAB8AAABUAAAAi47jAP///wEAAAAAAAAAAAAAAAAAAAAAAAAAAAAAAAAAAAAAAAAAAAAAAAJ/f38AWVlZA8zMzADAwP8Af39/AAAAAAAAAAAAAAAAAAAAAAAAAAAAIQAAABgAAAAUAAAAMAQAAMkhAAADGQAA3yQAABAAAAAmAAAACAAAAP//////////"/>
+                <pr:smNativeData xmlns:pr="smNativeData" xmlns="smNativeData" val="SMDATA_15_9kV5ZhMAAAAlAAAAZQAAAA0AAAAAqQEAAJAAAACpAQAAkAAAAAAAAAABAAAAAAAAAAEAAABQAAAAhbacS3FV1T8AAAAAAAAAAAAAAAAAAOA/AAAAAAAA4D8AAAAAAADgPwAAAAAAAOA/AAAAAAAA4D8AAAAAAADgPwAAAAAAAOA/AAAAAAAA4D8CAAAAjAAAAAEAAAAAAAAAi47jAP///wgAAAAAAAAAAAAAAAAAAAAAAAAAAAAAAAAAAAAAeAAAAAEAAABAAAAAAAAAAAAAAABaAAAAAAAAAAAAAAAAAAAAAAAAAAAAAAAAAAAAAAAAAAAAAAAAAAAAAAAAAAAAAAAAAAAAAAAAAAAAAAAAAAAAAAAAAAAAAAAAAAAAFAAAADwAAAAAAAAAAAAAAAAAAAkUAAAAAQAAABQAAAAUAAAAFAAAAAEAAAAAAAAAZAAAAGQAAAAAAAAAZAAAAGQAAAAVAAAAYAAAAAAAAAAAAAAADwAAACADAAAAAAAAAAAAAAEAAACgMgAAVgcAAKr4//8BAAAAf39/AAEAAABkAAAAAAAAABQAAABAHwAAAAAAACYAAAAAAAAAwOD//wAAAAAmAAAAZAAAABYAAABMAAAAAAAAAAAAAAAEAAAAAAAAAAEAAABZWVkKAAAAACgAAAAoAAAAZAAAAGQAAAAAAAAAzMzMAAAAAABQAAAAUAAAAGQAAABkAAAAAAAAABcAAAAUAAAAAAAAAAAAAAD/fwAA/38AAAAAAAAJAAAABAAAACOg4r4eAAAAaAAAAAAAAAAAAAAAAAAAAAAAAAAAAAAAECcAABAnAAAAAAAAAAAAAAAAAAAAAAAAAAAAAAAAAAAAAAAAAAAAABQAAAAAAAAAwMD/AAAAAABkAAAAMgAAAAAAAABkAAAAAAAAAH9/fwAKAAAAIgAAABgAAAAAAAAAAAAAAAAAAAAAAAAAAAAAAAAAAAAkAAAAJAAAAAAAAAAHAAAAAAAAAAAAAAAAAAAAAAAAAAAAAAAAAAAAf39/ACUAAABYAAAAAAAAAAAAAAAAAAAAAAAAAAAAAAAAAAAAAAAAAAAAAAAAAAAAAAAAAAAAAAA/AAAAAAAAAKCGAQAAAAAAAAAAAAAAAAAMAAAAAQAAAAAAAAAAAAAAAAAAAB8AAABUAAAAi47jAP///wEAAAAAAAAAAAAAAAAAAAAAAAAAAAAAAAAAAAAAAAAAAAAAAAJ/f38AWVlZA8zMzADAwP8Af39/AAAAAAAAAAAAAAAAAAAAAAAAAAAAIQAAABgAAAAUAAAAMAQAAMkhAAADGQAA3yQAABAAAAAmAAAACAAAAP//////////"/>
               </a:ext>
             </a:extLst>
           </p:cNvSpPr>
@@ -11482,7 +11482,7 @@
             <a:endCxn id="4" idx="1"/>
             <a:extLst>
               <a:ext uri="smNativeData">
-                <pr:smNativeData xmlns:pr="smNativeData" xmlns="smNativeData" val="SMDATA_15_FUV5ZhMAAAAlAAAADwAAAA0AAAAAkAAAAEgAAACQAAAASAAAAAAAAAAAAAAAAAAAAAEAAABQAAAAAAAAAADWiMAAAAAAAAAAAAAAAAAAAPA/AAAAAAAA4D8AAAAAAADgPwAAAAAAAOA/AAAAAAAA4D8AAAAAAADgPwAAAAAAAOA/AAAAAAAA4D8CAAAAjAAAAAAAAAAAAAAAQoX0DP///wgAAAAAAAAAAAAAAAAAAAAAAAAAAAAAAAAAAAAAZAAAAAEAAABAAAAAAAAAAAAAAAAAAAAAAAAAAAAAAAAAAAAAAAAAAAAAAAAAAAAAAAAAAAAAAAAAAAAAAAAAAAAAAAAAAAAAAAAAAAAAAAAAAAAAAAAAAAAAAAAAAAAAFAAAADwAAAABAAAAAwAAAAE9hQAeAAAAAQAAACMAAAAjAAAAIwAAAB4AAAAAAAAAZAAAAGQAAAAAAAAAZAAAAGQAAAAVAAAAYAAAAAAAAAAAAAAADwAAACADAAAAAAAAAAAAAAEAAACgMgAAVgcAAKr4//8BAAAAf39/AAEAAABkAAAAAAAAABQAAABAHwAAAAAAACYAAAAAAAAAwOD//wAAAAAmAAAAZAAAABYAAABMAAAAAAAAAAAAAAAEAAAAAAAAAAEAAABZWVkKAAAAACgAAAAoAAAAZAAAAGQAAAAAAAAAzMzMAAAAAABQAAAAUAAAAGQAAABkAAAAAAAAABcAAAAUAAAAAAAAAAAAAAD/fwAA/38AAAAAAAAJAAAABAAAAMkMAAAeAAAAaAAAAAAAAAAAAAAAAAAAAAAAAAAAAAAAECcAABAnAAAAAAAAAAAAAAAAAAAAAAAAAAAAAAAAAAAAAAAAAAAAABQAAAAAAAAAwMD/AAAAAABkAAAAMgAAAAAAAABkAAAAAAAAAH9/fwAKAAAAIgAAABgAAAAAAAAAAAAAAAAAAAAAAAAAAAAAAAAAAAAkAAAAJAAAAAAAAAAHAAAAAAAAAAAAAAAAAAAAAAAAAAAAAAAAAAAAf39/ACUAAABYAAAAAAAAAAAAAAAAAAAAAAAAAAAAAAAAAAAAAAAAAAAAAAAAAAAAAAAAAAAAAAA/AAAAAAAAAKCGAQAAAAAAAAAAAAAAAAAMAAAAAQAAAAAAAAAAAAAAAAAAAB8AAABUAAAAQoX0Bf///wEAAAAAAAAAAAAAAAAAAAAAAAAAAAAAAAAAAAAAAAAAAAE9hQB/f38AWVlZA8zMzADAwP8Af39/AAAAAAAAAAAAAAAAAAAAAAAAAAAAIQAAABgAAAAUAAAAMAQAAFgKAAAwBAAAaQ8AABAAAAAmAAAACAAAAP//////////"/>
+                <pr:smNativeData xmlns:pr="smNativeData" xmlns="smNativeData" val="SMDATA_15_9kV5ZhMAAAAlAAAADwAAAA0AAAAAkAAAAEgAAACQAAAASAAAAAAAAAAAAAAAAAAAAAEAAABQAAAAAAAAAADWiMAAAAAAAAAAAAAAAAAAAPA/AAAAAAAA4D8AAAAAAADgPwAAAAAAAOA/AAAAAAAA4D8AAAAAAADgPwAAAAAAAOA/AAAAAAAA4D8CAAAAjAAAAAAAAAAAAAAAQoX0DP///wgAAAAAAAAAAAAAAAAAAAAAAAAAAAAAAAAAAAAAZAAAAAEAAABAAAAAAAAAAAAAAAAAAAAAAAAAAAAAAAAAAAAAAAAAAAAAAAAAAAAAAAAAAAAAAAAAAAAAAAAAAAAAAAAAAAAAAAAAAAAAAAAAAAAAAAAAAAAAAAAAAAAAFAAAADwAAAABAAAAAwAAAAE9hQAeAAAAAQAAACMAAAAjAAAAIwAAAB4AAAAAAAAAZAAAAGQAAAAAAAAAZAAAAGQAAAAVAAAAYAAAAAAAAAAAAAAADwAAACADAAAAAAAAAAAAAAEAAACgMgAAVgcAAKr4//8BAAAAf39/AAEAAABkAAAAAAAAABQAAABAHwAAAAAAACYAAAAAAAAAwOD//wAAAAAmAAAAZAAAABYAAABMAAAAAAAAAAAAAAAEAAAAAAAAAAEAAABZWVkKAAAAACgAAAAoAAAAZAAAAGQAAAAAAAAAzMzMAAAAAABQAAAAUAAAAGQAAABkAAAAAAAAABcAAAAUAAAAAAAAAAAAAAD/fwAA/38AAAAAAAAJAAAABAAAAMkMAAAeAAAAaAAAAAAAAAAAAAAAAAAAAAAAAAAAAAAAECcAABAnAAAAAAAAAAAAAAAAAAAAAAAAAAAAAAAAAAAAAAAAAAAAABQAAAAAAAAAwMD/AAAAAABkAAAAMgAAAAAAAABkAAAAAAAAAH9/fwAKAAAAIgAAABgAAAAAAAAAAAAAAAAAAAAAAAAAAAAAAAAAAAAkAAAAJAAAAAAAAAAHAAAAAAAAAAAAAAAAAAAAAAAAAAAAAAAAAAAAf39/ACUAAABYAAAAAAAAAAAAAAAAAAAAAAAAAAAAAAAAAAAAAAAAAAAAAAAAAAAAAAAAAAAAAAA/AAAAAAAAAKCGAQAAAAAAAAAAAAAAAAAMAAAAAQAAAAAAAAAAAAAAAAAAAB8AAABUAAAAQoX0Bf///wEAAAAAAAAAAAAAAAAAAAAAAAAAAAAAAAAAAAAAAAAAAAE9hQB/f38AWVlZA8zMzADAwP8Af39/AAAAAAAAAAAAAAAAAAAAAAAAAAAAIQAAABgAAAAUAAAAMAQAAFgKAAAwBAAAaQ8AABAAAAAmAAAACAAAAP//////////"/>
               </a:ext>
             </a:extLst>
           </p:cNvCxnSpPr>
@@ -11518,7 +11518,7 @@
             <a:endCxn id="5" idx="1"/>
             <a:extLst>
               <a:ext uri="smNativeData">
-                <pr:smNativeData xmlns:pr="smNativeData" xmlns="smNativeData" val="SMDATA_15_FUV5ZhMAAAAlAAAADwAAAA0AAAAAkAAAAEgAAACQAAAASAAAAAAAAAAAAAAAAAAAAAEAAABQAAAAAAAAAADWiMAAAAAAAAAAAAAAAAAAAPA/AAAAAAAA4D8AAAAAAADgPwAAAAAAAOA/AAAAAAAA4D8AAAAAAADgPwAAAAAAAOA/AAAAAAAA4D8CAAAAjAAAAAAAAAAAAAAAQoX0DP///wgAAAAAAAAAAAAAAAAAAAAAAAAAAAAAAAAAAAAAZAAAAAEAAABAAAAAAAAAAAAAAAAAAAAAAAAAAAAAAAAAAAAAAAAAAAAAAAAAAAAAAAAAAAAAAAAAAAAAAAAAAAAAAAAAAAAAAAAAAAAAAAAAAAAAAAAAAAAAAAAAAAAAFAAAADwAAAABAAAAAwAAAAE9hQAeAAAAAQAAACMAAAAjAAAAIwAAAB4AAAAAAAAAZAAAAGQAAAAAAAAAZAAAAGQAAAAVAAAAYAAAAAAAAAAAAAAADwAAACADAAAAAAAAAAAAAAEAAACgMgAAVgcAAKr4//8BAAAAf39/AAEAAABkAAAAAAAAABQAAABAHwAAAAAAACYAAAAAAAAAwOD//wAAAAAmAAAAZAAAABYAAABMAAAAAAAAAAAAAAAEAAAAAAAAAAEAAABZWVkKAAAAACgAAAAoAAAAZAAAAGQAAAAAAAAAzMzMAAAAAABQAAAAUAAAAGQAAABkAAAAAAAAABcAAAAUAAAAAAAAAAAAAAD/fwAA/38AAAAAAAAJAAAABAAAAAAAAAAeAAAAaAAAAAAAAAAAAAAAAAAAAAAAAAAAAAAAECcAABAnAAAAAAAAAAAAAAAAAAAAAAAAAAAAAAAAAAAAAAAAAAAAABQAAAAAAAAAwMD/AAAAAABkAAAAMgAAAAAAAABkAAAAAAAAAH9/fwAKAAAAIgAAABgAAAAAAAAAAAAAAAAAAAAAAAAAAAAAAAAAAAAkAAAAJAAAAAAAAAAHAAAAAAAAAAAAAAAAAAAAAAAAAAAAAAAAAAAAf39/ACUAAABYAAAAAAAAAAAAAAAAAAAAAAAAAAAAAAAAAAAAAAAAAAAAAAAAAAAAAAAAAAAAAAA/AAAAAAAAAKCGAQAAAAAAAAAAAAAAAAAMAAAAAQAAAAAAAAAAAAAAAAAAAB8AAABUAAAAQoX0Bf///wEAAAAAAAAAAAAAAAAAAAAAAAAAAAAAAAAAAAAAAAAAAAE9hQB/f38AWVlZA8zMzADAwP8Af39/AAAAAAAAAAAAAAAAAAAAAAAAAAAAIQAAABgAAAAUAAAAMAQAAGkPAAAwBAAAjxQAABAAAAAmAAAACAAAAP//////////"/>
+                <pr:smNativeData xmlns:pr="smNativeData" xmlns="smNativeData" val="SMDATA_15_9kV5ZhMAAAAlAAAADwAAAA0AAAAAkAAAAEgAAACQAAAASAAAAAAAAAAAAAAAAAAAAAEAAABQAAAAAAAAAADWiMAAAAAAAAAAAAAAAAAAAPA/AAAAAAAA4D8AAAAAAADgPwAAAAAAAOA/AAAAAAAA4D8AAAAAAADgPwAAAAAAAOA/AAAAAAAA4D8CAAAAjAAAAAAAAAAAAAAAQoX0DP///wgAAAAAAAAAAAAAAAAAAAAAAAAAAAAAAAAAAAAAZAAAAAEAAABAAAAAAAAAAAAAAAAAAAAAAAAAAAAAAAAAAAAAAAAAAAAAAAAAAAAAAAAAAAAAAAAAAAAAAAAAAAAAAAAAAAAAAAAAAAAAAAAAAAAAAAAAAAAAAAAAAAAAFAAAADwAAAABAAAAAwAAAAE9hQAeAAAAAQAAACMAAAAjAAAAIwAAAB4AAAAAAAAAZAAAAGQAAAAAAAAAZAAAAGQAAAAVAAAAYAAAAAAAAAAAAAAADwAAACADAAAAAAAAAAAAAAEAAACgMgAAVgcAAKr4//8BAAAAf39/AAEAAABkAAAAAAAAABQAAABAHwAAAAAAACYAAAAAAAAAwOD//wAAAAAmAAAAZAAAABYAAABMAAAAAAAAAAAAAAAEAAAAAAAAAAEAAABZWVkKAAAAACgAAAAoAAAAZAAAAGQAAAAAAAAAzMzMAAAAAABQAAAAUAAAAGQAAABkAAAAAAAAABcAAAAUAAAAAAAAAAAAAAD/fwAA/38AAAAAAAAJAAAABAAAAAAAAAAeAAAAaAAAAAAAAAAAAAAAAAAAAAAAAAAAAAAAECcAABAnAAAAAAAAAAAAAAAAAAAAAAAAAAAAAAAAAAAAAAAAAAAAABQAAAAAAAAAwMD/AAAAAABkAAAAMgAAAAAAAABkAAAAAAAAAH9/fwAKAAAAIgAAABgAAAAAAAAAAAAAAAAAAAAAAAAAAAAAAAAAAAAkAAAAJAAAAAAAAAAHAAAAAAAAAAAAAAAAAAAAAAAAAAAAAAAAAAAAf39/ACUAAABYAAAAAAAAAAAAAAAAAAAAAAAAAAAAAAAAAAAAAAAAAAAAAAAAAAAAAAAAAAAAAAA/AAAAAAAAAKCGAQAAAAAAAAAAAAAAAAAMAAAAAQAAAAAAAAAAAAAAAAAAAB8AAABUAAAAQoX0Bf///wEAAAAAAAAAAAAAAAAAAAAAAAAAAAAAAAAAAAAAAAAAAAE9hQB/f38AWVlZA8zMzADAwP8Af39/AAAAAAAAAAAAAAAAAAAAAAAAAAAAIQAAABgAAAAUAAAAMAQAAGkPAAAwBAAAjxQAABAAAAAmAAAACAAAAP//////////"/>
               </a:ext>
             </a:extLst>
           </p:cNvCxnSpPr>
@@ -11554,7 +11554,7 @@
             <a:endCxn id="6" idx="1"/>
             <a:extLst>
               <a:ext uri="smNativeData">
-                <pr:smNativeData xmlns:pr="smNativeData" xmlns="smNativeData" val="SMDATA_15_FUV5ZhMAAAAlAAAADwAAAA0AAAAAkAAAAEgAAACQAAAASAAAAAAAAAAAAAAAAAAAAAEAAABQAAAAAAAAAADWiMAAAAAAAAAAAAAAAAAAAPA/AAAAAAAA4D8AAAAAAADgPwAAAAAAAOA/AAAAAAAA4D8AAAAAAADgPwAAAAAAAOA/AAAAAAAA4D8CAAAAjAAAAAAAAAAAAAAAQoX0DP///wgAAAAAAAAAAAAAAAAAAAAAAAAAAAAAAAAAAAAAZAAAAAEAAABAAAAAAAAAAAAAAAAAAAAAAAAAAAAAAAAAAAAAAAAAAAAAAAAAAAAAAAAAAAAAAAAAAAAAAAAAAAAAAAAAAAAAAAAAAAAAAAAAAAAAAAAAAAAAAAAAAAAAFAAAADwAAAABAAAAAwAAAAE9hQAeAAAAAQAAACMAAAAjAAAAIwAAAB4AAAAAAAAAZAAAAGQAAAAAAAAAZAAAAGQAAAAVAAAAYAAAAAAAAAAAAAAADwAAACADAAAAAAAAAAAAAAEAAACgMgAAVgcAAKr4//8BAAAAf39/AAEAAABkAAAAAAAAABQAAABAHwAAAAAAACYAAAAAAAAAwOD//wAAAAAmAAAAZAAAABYAAABMAAAAAAAAAAAAAAAEAAAAAAAAAAEAAABZWVkKAAAAACgAAAAoAAAAZAAAAGQAAAAAAAAAzMzMAAAAAABQAAAAUAAAAGQAAABkAAAAAAAAABcAAAAUAAAAAAAAAAAAAAD/fwAA/38AAAAAAAAJAAAABAAAAB++y0QeAAAAaAAAAAAAAAAAAAAAAAAAAAAAAAAAAAAAECcAABAnAAAAAAAAAAAAAAAAAAAAAAAAAAAAAAAAAAAAAAAAAAAAABQAAAAAAAAAwMD/AAAAAABkAAAAMgAAAAAAAABkAAAAAAAAAH9/fwAKAAAAIgAAABgAAAAAAAAAAAAAAAAAAAAAAAAAAAAAAAAAAAAkAAAAJAAAAAAAAAAHAAAAAAAAAAAAAAAAAAAAAAAAAAAAAAAAAAAAf39/ACUAAABYAAAAAAAAAAAAAAAAAAAAAAAAAAAAAAAAAAAAAAAAAAAAAAAAAAAAAAAAAAAAAAA/AAAAAAAAAKCGAQAAAAAAAAAAAAAAAAAMAAAAAQAAAAAAAAAAAAAAAAAAAB8AAABUAAAAQoX0Bf///wEAAAAAAAAAAAAAAAAAAAAAAAAAAAAAAAAAAAAAAAAAAAE9hQB/f38AWVlZA8zMzADAwP8Af39/AAAAAAAAAAAAAAAAAAAAAAAAAAAAIQAAABgAAAAUAAAAMAQAAI8UAAAwBAAAtRkAABAAAAAmAAAACAAAAP//////////"/>
+                <pr:smNativeData xmlns:pr="smNativeData" xmlns="smNativeData" val="SMDATA_15_9kV5ZhMAAAAlAAAADwAAAA0AAAAAkAAAAEgAAACQAAAASAAAAAAAAAAAAAAAAAAAAAEAAABQAAAAAAAAAADWiMAAAAAAAAAAAAAAAAAAAPA/AAAAAAAA4D8AAAAAAADgPwAAAAAAAOA/AAAAAAAA4D8AAAAAAADgPwAAAAAAAOA/AAAAAAAA4D8CAAAAjAAAAAAAAAAAAAAAQoX0DP///wgAAAAAAAAAAAAAAAAAAAAAAAAAAAAAAAAAAAAAZAAAAAEAAABAAAAAAAAAAAAAAAAAAAAAAAAAAAAAAAAAAAAAAAAAAAAAAAAAAAAAAAAAAAAAAAAAAAAAAAAAAAAAAAAAAAAAAAAAAAAAAAAAAAAAAAAAAAAAAAAAAAAAFAAAADwAAAABAAAAAwAAAAE9hQAeAAAAAQAAACMAAAAjAAAAIwAAAB4AAAAAAAAAZAAAAGQAAAAAAAAAZAAAAGQAAAAVAAAAYAAAAAAAAAAAAAAADwAAACADAAAAAAAAAAAAAAEAAACgMgAAVgcAAKr4//8BAAAAf39/AAEAAABkAAAAAAAAABQAAABAHwAAAAAAACYAAAAAAAAAwOD//wAAAAAmAAAAZAAAABYAAABMAAAAAAAAAAAAAAAEAAAAAAAAAAEAAABZWVkKAAAAACgAAAAoAAAAZAAAAGQAAAAAAAAAzMzMAAAAAABQAAAAUAAAAGQAAABkAAAAAAAAABcAAAAUAAAAAAAAAAAAAAD/fwAA/38AAAAAAAAJAAAABAAAAB++y0QeAAAAaAAAAAAAAAAAAAAAAAAAAAAAAAAAAAAAECcAABAnAAAAAAAAAAAAAAAAAAAAAAAAAAAAAAAAAAAAAAAAAAAAABQAAAAAAAAAwMD/AAAAAABkAAAAMgAAAAAAAABkAAAAAAAAAH9/fwAKAAAAIgAAABgAAAAAAAAAAAAAAAAAAAAAAAAAAAAAAAAAAAAkAAAAJAAAAAAAAAAHAAAAAAAAAAAAAAAAAAAAAAAAAAAAAAAAAAAAf39/ACUAAABYAAAAAAAAAAAAAAAAAAAAAAAAAAAAAAAAAAAAAAAAAAAAAAAAAAAAAAAAAAAAAAA/AAAAAAAAAKCGAQAAAAAAAAAAAAAAAAAMAAAAAQAAAAAAAAAAAAAAAAAAAB8AAABUAAAAQoX0Bf///wEAAAAAAAAAAAAAAAAAAAAAAAAAAAAAAAAAAAAAAAAAAAE9hQB/f38AWVlZA8zMzADAwP8Af39/AAAAAAAAAAAAAAAAAAAAAAAAAAAAIQAAABgAAAAUAAAAMAQAAI8UAAAwBAAAtRkAABAAAAAmAAAACAAAAP//////////"/>
               </a:ext>
             </a:extLst>
           </p:cNvCxnSpPr>
@@ -11588,7 +11588,7 @@
           <p:cNvCxnSpPr>
             <a:extLst>
               <a:ext uri="smNativeData">
-                <pr:smNativeData xmlns:pr="smNativeData" xmlns="smNativeData" val="SMDATA_15_FUV5ZhMAAAAlAAAADwAAAA0AAAAAkAAAAEgAAACQAAAASAAAAAAAAAAAAAAAAAAAAAEAAABQAAAAAAAAAADWiMAAAAAAAAAAAAAAAAAAAPA/AAAAAAAA4D8AAAAAAADgPwAAAAAAAOA/AAAAAAAA4D8AAAAAAADgPwAAAAAAAOA/AAAAAAAA4D8CAAAAjAAAAAAAAAAAAAAAQoX0DP///wgAAAAAAAAAAAAAAAAAAAAAAAAAAAAAAAAAAAAAZAAAAAEAAABAAAAAAAAAAAAAAAAAAAAAAAAAAAAAAAAAAAAAAAAAAAAAAAAAAAAAAAAAAAAAAAAAAAAAAAAAAAAAAAAAAAAAAAAAAAAAAAAAAAAAAAAAAAAAAAAAAAAAFAAAADwAAAABAAAAAwAAAAE9hQAeAAAAAQAAACMAAAAjAAAAIwAAAB4AAAAAAAAAZAAAAGQAAAAAAAAAZAAAAGQAAAAVAAAAYAAAAAAAAAAAAAAADwAAACADAAAAAAAAAAAAAAEAAACgMgAAVgcAAKr4//8BAAAAf39/AAEAAABkAAAAAAAAABQAAABAHwAAAAAAACYAAAAAAAAAwOD//wAAAAAmAAAAZAAAABYAAABMAAAAAAAAAAAAAAAEAAAAAAAAAAEAAABZWVkKAAAAACgAAAAoAAAAZAAAAGQAAAAAAAAAzMzMAAAAAABQAAAAUAAAAGQAAABkAAAAAAAAABcAAAAUAAAAAAAAAAAAAAD/fwAA/38AAAAAAAAJAAAABAAAAAAAAAAeAAAAaAAAAAAAAAAAAAAAAAAAAAAAAAAAAAAAECcAABAnAAAAAAAAAAAAAAAAAAAAAAAAAAAAAAAAAAAAAAAAAAAAABQAAAAAAAAAwMD/AAAAAABkAAAAMgAAAAAAAABkAAAAAAAAAH9/fwAKAAAAIgAAABgAAAAAAAAAAAAAAAAAAAAAAAAAAAAAAAAAAAAkAAAAJAAAAAAAAAAHAAAAAAAAAAAAAAAAAAAAAAAAAAAAAAAAAAAAf39/ACUAAABYAAAAAAAAAAAAAAAAAAAAAAAAAAAAAAAAAAAAAAAAAAAAAAAAAAAAAAAAAAAAAAA/AAAAAAAAAKCGAQAAAAAAAAAAAAAAAAAMAAAAAQAAAAAAAAAAAAAAAAAAAB8AAABUAAAAQoX0Bf///wEAAAAAAAAAAAAAAAAAAAAAAAAAAAAAAAAAAAAAAAAAAAE9hQB/f38AWVlZA8zMzADAwP8Af39/AAAAAAAAAAAAAAAAAAAAAAAAAAAAIQAAABgAAAAUAAAAMAQAAPUZAAAxBAAAGx8AABAAAAAmAAAACAAAAP//////////"/>
+                <pr:smNativeData xmlns:pr="smNativeData" xmlns="smNativeData" val="SMDATA_15_9kV5ZhMAAAAlAAAADwAAAA0AAAAAkAAAAEgAAACQAAAASAAAAAAAAAAAAAAAAAAAAAEAAABQAAAAAAAAAADWiMAAAAAAAAAAAAAAAAAAAPA/AAAAAAAA4D8AAAAAAADgPwAAAAAAAOA/AAAAAAAA4D8AAAAAAADgPwAAAAAAAOA/AAAAAAAA4D8CAAAAjAAAAAAAAAAAAAAAQoX0DP///wgAAAAAAAAAAAAAAAAAAAAAAAAAAAAAAAAAAAAAZAAAAAEAAABAAAAAAAAAAAAAAAAAAAAAAAAAAAAAAAAAAAAAAAAAAAAAAAAAAAAAAAAAAAAAAAAAAAAAAAAAAAAAAAAAAAAAAAAAAAAAAAAAAAAAAAAAAAAAAAAAAAAAFAAAADwAAAABAAAAAwAAAAE9hQAeAAAAAQAAACMAAAAjAAAAIwAAAB4AAAAAAAAAZAAAAGQAAAAAAAAAZAAAAGQAAAAVAAAAYAAAAAAAAAAAAAAADwAAACADAAAAAAAAAAAAAAEAAACgMgAAVgcAAKr4//8BAAAAf39/AAEAAABkAAAAAAAAABQAAABAHwAAAAAAACYAAAAAAAAAwOD//wAAAAAmAAAAZAAAABYAAABMAAAAAAAAAAAAAAAEAAAAAAAAAAEAAABZWVkKAAAAACgAAAAoAAAAZAAAAGQAAAAAAAAAzMzMAAAAAABQAAAAUAAAAGQAAABkAAAAAAAAABcAAAAUAAAAAAAAAAAAAAD/fwAA/38AAAAAAAAJAAAABAAAAAAAAAAeAAAAaAAAAAAAAAAAAAAAAAAAAAAAAAAAAAAAECcAABAnAAAAAAAAAAAAAAAAAAAAAAAAAAAAAAAAAAAAAAAAAAAAABQAAAAAAAAAwMD/AAAAAABkAAAAMgAAAAAAAABkAAAAAAAAAH9/fwAKAAAAIgAAABgAAAAAAAAAAAAAAAAAAAAAAAAAAAAAAAAAAAAkAAAAJAAAAAAAAAAHAAAAAAAAAAAAAAAAAAAAAAAAAAAAAAAAAAAAf39/ACUAAABYAAAAAAAAAAAAAAAAAAAAAAAAAAAAAAAAAAAAAAAAAAAAAAAAAAAAAAAAAAAAAAA/AAAAAAAAAKCGAQAAAAAAAAAAAAAAAAAMAAAAAQAAAAAAAAAAAAAAAAAAAB8AAABUAAAAQoX0Bf///wEAAAAAAAAAAAAAAAAAAAAAAAAAAAAAAAAAAAAAAAAAAAE9hQB/f38AWVlZA8zMzADAwP8Af39/AAAAAAAAAAAAAAAAAAAAAAAAAAAAIQAAABgAAAAUAAAAMAQAAPUZAAAxBAAAGx8AABAAAAAmAAAACAAAAP//////////"/>
               </a:ext>
             </a:extLst>
           </p:cNvCxnSpPr>
@@ -11622,7 +11622,7 @@
           <p:cNvCxnSpPr>
             <a:extLst>
               <a:ext uri="smNativeData">
-                <pr:smNativeData xmlns:pr="smNativeData" xmlns="smNativeData" val="SMDATA_15_FUV5ZhMAAAAlAAAADwAAAA0AAAAAkAAAAEgAAACQAAAASAAAAAAAAAAAAAAAAAAAAAEAAABQAAAAAAAAAADWiMAAAAAAAAAAAAAAAAAAAPA/AAAAAAAA4D8AAAAAAADgPwAAAAAAAOA/AAAAAAAA4D8AAAAAAADgPwAAAAAAAOA/AAAAAAAA4D8CAAAAjAAAAAAAAAAAAAAAQoX0DP///wgAAAAAAAAAAAAAAAAAAAAAAAAAAAAAAAAAAAAAZAAAAAEAAABAAAAAAAAAAAAAAAAAAAAAAAAAAAAAAAAAAAAAAAAAAAAAAAAAAAAAAAAAAAAAAAAAAAAAAAAAAAAAAAAAAAAAAAAAAAAAAAAAAAAAAAAAAAAAAAAAAAAAFAAAADwAAAABAAAAAwAAAAE9hQAeAAAAAQAAACMAAAAjAAAAIwAAAB4AAAAAAAAAZAAAAGQAAAAAAAAAZAAAAGQAAAAVAAAAYAAAAAAAAAAAAAAADwAAACADAAAAAAAAAAAAAAEAAACgMgAAVgcAAKr4//8BAAAAf39/AAEAAABkAAAAAAAAABQAAABAHwAAAAAAACYAAAAAAAAAwOD//wAAAAAmAAAAZAAAABYAAABMAAAAAAAAAAAAAAAEAAAAAAAAAAEAAABZWVkKAAAAACgAAAAoAAAAZAAAAGQAAAAAAAAAzMzMAAAAAABQAAAAUAAAAGQAAABkAAAAAAAAABcAAAAUAAAAAAAAAAAAAAD/fwAA/38AAAAAAAAJAAAABAAAACgAAAAeAAAAaAAAAAAAAAAAAAAAAAAAAAAAAAAAAAAAECcAABAnAAAAAAAAAAAAAAAAAAAAAAAAAAAAAAAAAAAAAAAAAAAAABQAAAAAAAAAwMD/AAAAAABkAAAAMgAAAAAAAABkAAAAAAAAAH9/fwAKAAAAIgAAABgAAAAAAAAAAAAAAAAAAAAAAAAAAAAAAAAAAAAkAAAAJAAAAAAAAAAHAAAAAAAAAAAAAAAAAAAAAAAAAAAAAAAAAAAAf39/ACUAAABYAAAAAAAAAAAAAAAAAAAAAAAAAAAAAAAAAAAAAAAAAAAAAAAAAAAAAAAAAAAAAAA/AAAAAAAAAKCGAQAAAAAAAAAAAAAAAAAMAAAAAQAAAAAAAAAAAAAAAAAAAB8AAABUAAAAQoX0Bf///wEAAAAAAAAAAAAAAAAAAAAAAAAAAAAAAAAAAAAAAAAAAAE9hQB/f38AWVlZA8zMzADAwP8Af39/AAAAAAAAAAAAAAAAAAAAAAAAAAAAIQAAABgAAAAUAAAAMAQAAFofAAAxBAAAgCQAABAAAAAmAAAACAAAAP//////////"/>
+                <pr:smNativeData xmlns:pr="smNativeData" xmlns="smNativeData" val="SMDATA_15_9kV5ZhMAAAAlAAAADwAAAA0AAAAAkAAAAEgAAACQAAAASAAAAAAAAAAAAAAAAAAAAAEAAABQAAAAAAAAAADWiMAAAAAAAAAAAAAAAAAAAPA/AAAAAAAA4D8AAAAAAADgPwAAAAAAAOA/AAAAAAAA4D8AAAAAAADgPwAAAAAAAOA/AAAAAAAA4D8CAAAAjAAAAAAAAAAAAAAAQoX0DP///wgAAAAAAAAAAAAAAAAAAAAAAAAAAAAAAAAAAAAAZAAAAAEAAABAAAAAAAAAAAAAAAAAAAAAAAAAAAAAAAAAAAAAAAAAAAAAAAAAAAAAAAAAAAAAAAAAAAAAAAAAAAAAAAAAAAAAAAAAAAAAAAAAAAAAAAAAAAAAAAAAAAAAFAAAADwAAAABAAAAAwAAAAE9hQAeAAAAAQAAACMAAAAjAAAAIwAAAB4AAAAAAAAAZAAAAGQAAAAAAAAAZAAAAGQAAAAVAAAAYAAAAAAAAAAAAAAADwAAACADAAAAAAAAAAAAAAEAAACgMgAAVgcAAKr4//8BAAAAf39/AAEAAABkAAAAAAAAABQAAABAHwAAAAAAACYAAAAAAAAAwOD//wAAAAAmAAAAZAAAABYAAABMAAAAAAAAAAAAAAAEAAAAAAAAAAEAAABZWVkKAAAAACgAAAAoAAAAZAAAAGQAAAAAAAAAzMzMAAAAAABQAAAAUAAAAGQAAABkAAAAAAAAABcAAAAUAAAAAAAAAAAAAAD/fwAA/38AAAAAAAAJAAAABAAAACgAAAAeAAAAaAAAAAAAAAAAAAAAAAAAAAAAAAAAAAAAECcAABAnAAAAAAAAAAAAAAAAAAAAAAAAAAAAAAAAAAAAAAAAAAAAABQAAAAAAAAAwMD/AAAAAABkAAAAMgAAAAAAAABkAAAAAAAAAH9/fwAKAAAAIgAAABgAAAAAAAAAAAAAAAAAAAAAAAAAAAAAAAAAAAAkAAAAJAAAAAAAAAAHAAAAAAAAAAAAAAAAAAAAAAAAAAAAAAAAAAAAf39/ACUAAABYAAAAAAAAAAAAAAAAAAAAAAAAAAAAAAAAAAAAAAAAAAAAAAAAAAAAAAAAAAAAAAA/AAAAAAAAAKCGAQAAAAAAAAAAAAAAAAAMAAAAAQAAAAAAAAAAAAAAAAAAAB8AAABUAAAAQoX0Bf///wEAAAAAAAAAAAAAAAAAAAAAAAAAAAAAAAAAAAAAAAAAAAE9hQB/f38AWVlZA8zMzADAwP8Af39/AAAAAAAAAAAAAAAAAAAAAAAAAAAAIQAAABgAAAAUAAAAMAQAAFofAAAxBAAAgCQAABAAAAAmAAAACAAAAP//////////"/>
               </a:ext>
             </a:extLst>
           </p:cNvCxnSpPr>
@@ -11689,7 +11689,7 @@
             <a:spLocks noGrp="1" noChangeArrowheads="1"/>
             <a:extLst>
               <a:ext uri="smNativeData">
-                <pr:smNativeData xmlns:pr="smNativeData" xmlns="smNativeData" val="SMDATA_15_FUV5ZhMAAAAlAAAAZAAAAA0AAAAAkAAAAJAAAACQAAAAkAAAAAAAAAAAAAAAAAAAAAEAAABQAAAAAAAAAAAA4D8AAAAAAADgPwAAAAAAAOA/AAAAAAAA4D8AAAAAAADgPwAAAAAAAOA/AAAAAAAA4D8AAAAAAADgPwAAAAAAAOA/AAAAAAAA4D8CAAAAjAAAAAAAAAAAAAAAQoX0DP///wgAAAAAAAAAAAAAAAAAAAAAAAAAAAAAAAAAAAAAZAAAAAEAAABAAAAAAAAAAAAAAAAAAAAAAAAAAAAAAAAAAAAAAAAAAAAAAAAAAAAAAAAAAAAAAAAAAAAAAAAAAAAAAAAAAAAAAAAAAAAAAAAAAAAAAAAAAAAAAAAAAAAAFAAAADwAAAAAAAAAAAAAAAAAAAkUAAAAAQAAABQAAAAUAAAAFAAAAAEAAAAAAAAAZAAAAGQAAAAAAAAAZAAAAGQAAAAVAAAAYAAAAAAAAAAAAAAADwAAACADAAAAAAAAAAAAAAEAAACgMgAAVgcAAKr4//8BAAAAf39/AAEAAABkAAAAAAAAABQAAABAHwAAAAAAACYAAAAAAAAAwOD//wAAAAAmAAAAZAAAABYAAABMAAAAAAAAAAAAAAAEAAAAAAAAAAEAAABZWVkKAAAAACgAAAAoAAAAZAAAAGQAAAAAAAAAzMzMAAAAAABQAAAAUAAAAGQAAABkAAAAAAAAABcAAAAUAAAAAAAAAAAAAAD/fwAA/38AAAAAAAAJAAAABAAAACOP964eAAAAaAAAAAAAAAAAAAAAAAAAAAAAAAAAAAAAECcAABAnAAAAAAAAAAAAAAAAAAAAAAAAAAAAAAAAAAAAAAAAAAAAABQAAAAAAAAAwMD/AAAAAABkAAAAMgAAAAAAAABkAAAAAAAAAH9/fwAKAAAAIgAAABgAAAAAAAAAAAAAAAAAAAAAAAAAAAAAAAAAAAAkAAAAJAAAAAAAAAAHAAAAAAAAAAAAAAAAAAAAAAAAAAAAAAAAAAAAf39/ACUAAABYAAAAAAAAAAAAAAAAAAAAAAAAAAAAAAAAAAAAAAAAAAAAAAAAAAAAAAAAAAAAAAA/AAAAAAAAAKCGAQAAAAAAAAAAAAAAAAAMAAAAAQAAAAAAAAAAAAAAAAAAAB8AAABUAAAAQoX0Bf///wEAAAAAAAAAAAAAAAAAAAAAAAAAAAAAAAAAAAAAAAAAAAAAAAJ/f38AWVlZA8zMzADAwP8Af39/AAAAAAAAAAAAAAAAAAAAAAAAAAAAIQAAABgAAAAUAAAAFAMAALYCAAB/NwAAvwoAABAAAAAmAAAACAAAADwwAAAAAAAA"/>
+                <pr:smNativeData xmlns:pr="smNativeData" xmlns="smNativeData" val="SMDATA_15_9kV5ZhMAAAAlAAAAZAAAAA0AAAAAkAAAAJAAAACQAAAAkAAAAAAAAAAAAAAAAAAAAAEAAABQAAAAAAAAAAAA4D8AAAAAAADgPwAAAAAAAOA/AAAAAAAA4D8AAAAAAADgPwAAAAAAAOA/AAAAAAAA4D8AAAAAAADgPwAAAAAAAOA/AAAAAAAA4D8CAAAAjAAAAAAAAAAAAAAAQoX0DP///wgAAAAAAAAAAAAAAAAAAAAAAAAAAAAAAAAAAAAAZAAAAAEAAABAAAAAAAAAAAAAAAAAAAAAAAAAAAAAAAAAAAAAAAAAAAAAAAAAAAAAAAAAAAAAAAAAAAAAAAAAAAAAAAAAAAAAAAAAAAAAAAAAAAAAAAAAAAAAAAAAAAAAFAAAADwAAAAAAAAAAAAAAAAAAAkUAAAAAQAAABQAAAAUAAAAFAAAAAEAAAAAAAAAZAAAAGQAAAAAAAAAZAAAAGQAAAAVAAAAYAAAAAAAAAAAAAAADwAAACADAAAAAAAAAAAAAAEAAACgMgAAVgcAAKr4//8BAAAAf39/AAEAAABkAAAAAAAAABQAAABAHwAAAAAAACYAAAAAAAAAwOD//wAAAAAmAAAAZAAAABYAAABMAAAAAAAAAAAAAAAEAAAAAAAAAAEAAABZWVkKAAAAACgAAAAoAAAAZAAAAGQAAAAAAAAAzMzMAAAAAABQAAAAUAAAAGQAAABkAAAAAAAAABcAAAAUAAAAAAAAAAAAAAD/fwAA/38AAAAAAAAJAAAABAAAACOP964eAAAAaAAAAAAAAAAAAAAAAAAAAAAAAAAAAAAAECcAABAnAAAAAAAAAAAAAAAAAAAAAAAAAAAAAAAAAAAAAAAAAAAAABQAAAAAAAAAwMD/AAAAAABkAAAAMgAAAAAAAABkAAAAAAAAAH9/fwAKAAAAIgAAABgAAAAAAAAAAAAAAAAAAAAAAAAAAAAAAAAAAAAkAAAAJAAAAAAAAAAHAAAAAAAAAAAAAAAAAAAAAAAAAAAAAAAAAAAAf39/ACUAAABYAAAAAAAAAAAAAAAAAAAAAAAAAAAAAAAAAAAAAAAAAAAAAAAAAAAAAAAAAAAAAAA/AAAAAAAAAKCGAQAAAAAAAAAAAAAAAAAMAAAAAQAAAAAAAAAAAAAAAAAAAB8AAABUAAAAAAAABQAAAAEAAAAAAAAAAAAAAAAAAAAAAAAAAAAAAAAAAAAAAAAAAAAAAAJ/f38AWVlZA8zMzADAwP8Af39/AAAAAAAAAAAAAAAAAAAAAAAAAAAAIQAAABgAAAAUAAAAFAMAALYCAAB/NwAAvwoAABAAAAAmAAAACAAAADwwAAAAAAAA"/>
               </a:ext>
             </a:extLst>
           </p:cNvSpPr>
@@ -11879,7 +11879,7 @@
                 </a:tc>
                 <a:extLst>
                   <a:ext uri="smNativeData">
-                    <pr:rowheight xmlns="" xmlns:pr="smNativeData" dt="1719223573" type="min" val="381000"/>
+                    <pr:rowheight xmlns="" xmlns:pr="smNativeData" dt="1719223798" type="min" val="381000"/>
                   </a:ext>
                 </a:extLst>
               </a:tr>
@@ -12027,7 +12027,7 @@
                 </a:tc>
                 <a:extLst>
                   <a:ext uri="smNativeData">
-                    <pr:rowheight xmlns="" xmlns:pr="smNativeData" dt="1719223573" type="min" val="381000"/>
+                    <pr:rowheight xmlns="" xmlns:pr="smNativeData" dt="1719223798" type="min" val="381000"/>
                   </a:ext>
                 </a:extLst>
               </a:tr>
@@ -12175,7 +12175,7 @@
                 </a:tc>
                 <a:extLst>
                   <a:ext uri="smNativeData">
-                    <pr:rowheight xmlns="" xmlns:pr="smNativeData" dt="1719223573" type="min" val="381000"/>
+                    <pr:rowheight xmlns="" xmlns:pr="smNativeData" dt="1719223798" type="min" val="381000"/>
                   </a:ext>
                 </a:extLst>
               </a:tr>
@@ -12323,7 +12323,7 @@
                 </a:tc>
                 <a:extLst>
                   <a:ext uri="smNativeData">
-                    <pr:rowheight xmlns="" xmlns:pr="smNativeData" dt="1719223573" type="min" val="381000"/>
+                    <pr:rowheight xmlns="" xmlns:pr="smNativeData" dt="1719223798" type="min" val="381000"/>
                   </a:ext>
                 </a:extLst>
               </a:tr>
@@ -12337,7 +12337,7 @@
           <p:cNvSpPr>
             <a:extLst>
               <a:ext uri="smNativeData">
-                <pr:smNativeData xmlns:pr="smNativeData" xmlns="smNativeData" val="SMDATA_15_FUV5ZhMAAAAlAAAA9AEAAA0AAAAAOAEAAMYAAAA4AQAAxgAAAAAAAAABAAAAAAAAAAEAAABQAAAAe0ljtI6q2r8AAAAAAAD0PwAAAAAAAOA/AAAAAAAA4D8AAAAAAADgPwAAAAAAAOA/AAAAAAAA4D8AAAAAAADgPwAAAAAAAOA/AAAAAAAA4D8CAAAAjAAAAAEAAAAAAAAA8/PzAP///wgAAAAAAAAAAAAAAAAAAAAAAAAAAAAAAAAAAAAAeAAAAAEAAABAAAAAAAAAAAAAAABaAAAAAAAAAAAAAAAAAAAAAAAAAAAAAAAAAAAAAAAAAAAAAAAAAAAAAAAAAAAAAAAAAAAAAAAAAAAAAAAAAAAAAAAAAAAAAAAAAAAAFAAAADwAAAABAAAAAAAAAAE9hQAPAAAAAQAAACMAAAAjAAAAIwAAAB4AAAAAAAAASwAAAEsAAAAAAAAASwAAAEsAAAAVAAAAYAAAAAAAAAAAAAAADwAAACADAAAAAAAAAAAAAAEAAACgMgAAVgcAAKr4//8BAAAAf39/AAEAAABkAAAAAAAAABQAAABAHwAAAAAAACYAAAAAAAAAwOD//wAAAAAmAAAAZAAAABYAAABMAAAAAAAAAAAAAAAEAAAAAAAAAAEAAABZWVkKAAAAACgAAAAoAAAAZAAAAGQAAAAAAAAAzMzMAAAAAABQAAAAUAAAAGQAAABkAAAAAAAAABcAAAAUAAAAAAAAAAAAAAD/fwAA/38AAAAAAAAJAAAABAAAADpUCpYeAAAAaAAAAAAAAAAAAAAAAAAAAAAAAAAAAAAAECcAABAnAAAAAAAAAAAAAAAAAAAAAAAAAAAAAAAAAAAAAAAAAAAAABQAAAAAAAAAwMD/AAAAAABkAAAAMgAAAAAAAABkAAAAAAAAAH9/fwAKAAAAIgAAABgAAAAAAAAAAAAAAAAAAAAAAAAAAAAAAAAAAAAkAAAAJAAAAAAAAAAHAAAAAAAAAAAAAAAAAAAAAAAAAAAAAAAAAAAAf39/ACUAAABYAAAAAAAAAAAAAAAAAAAAAAAAAAAAAAAAAAAAAAAAAAAAAAAAAAAAAAAAAAAAAAA/AAAAAAAAAKCGAQAAAAAAAAAAAAAAAAAMAAAAAQAAAAAAAAAAAAAAAAAAAB8AAABUAAAA8/PzAP///wEAAAAAAAAAAAAAAAAAAAAAAAAAAAAAAAAAAAAAAAAAAAE9hQB/f38AWVlZA8zMzADAwP8Af39/AAAAAAAAAAAAAAAAAAAAAAAAAAAAIQAAABgAAAAUAAAA2CAAAFMCAADnNQAACwkAABAAAAAmAAAACAAAAP//////////"/>
+                <pr:smNativeData xmlns:pr="smNativeData" xmlns="smNativeData" val="SMDATA_15_9kV5ZhMAAAAlAAAA9AEAAA0AAAAAOAEAAMYAAAA4AQAAxgAAAAAAAAABAAAAAAAAAAEAAABQAAAAe0ljtI6q2r8AAAAAAAD0PwAAAAAAAOA/AAAAAAAA4D8AAAAAAADgPwAAAAAAAOA/AAAAAAAA4D8AAAAAAADgPwAAAAAAAOA/AAAAAAAA4D8CAAAAjAAAAAEAAAAAAAAA8/PzAP///wgAAAAAAAAAAAAAAAAAAAAAAAAAAAAAAAAAAAAAeAAAAAEAAABAAAAAAAAAAAAAAABaAAAAAAAAAAAAAAAAAAAAAAAAAAAAAAAAAAAAAAAAAAAAAAAAAAAAAAAAAAAAAAAAAAAAAAAAAAAAAAAAAAAAAAAAAAAAAAAAAAAAFAAAADwAAAABAAAAAAAAAAE9hQAPAAAAAQAAACMAAAAjAAAAIwAAAB4AAAAAAAAASwAAAEsAAAAAAAAASwAAAEsAAAAVAAAAYAAAAAAAAAAAAAAADwAAACADAAAAAAAAAAAAAAEAAACgMgAAVgcAAKr4//8BAAAAf39/AAEAAABkAAAAAAAAABQAAABAHwAAAAAAACYAAAAAAAAAwOD//wAAAAAmAAAAZAAAABYAAABMAAAAAAAAAAAAAAAEAAAAAAAAAAEAAABZWVkKAAAAACgAAAAoAAAAZAAAAGQAAAAAAAAAzMzMAAAAAABQAAAAUAAAAGQAAABkAAAAAAAAABcAAAAUAAAAAAAAAAAAAAD/fwAA/38AAAAAAAAJAAAABAAAADpUCpYeAAAAaAAAAAAAAAAAAAAAAAAAAAAAAAAAAAAAECcAABAnAAAAAAAAAAAAAAAAAAAAAAAAAAAAAAAAAAAAAAAAAAAAABQAAAAAAAAAwMD/AAAAAABkAAAAMgAAAAAAAABkAAAAAAAAAH9/fwAKAAAAIgAAABgAAAAAAAAAAAAAAAAAAAAAAAAAAAAAAAAAAAAkAAAAJAAAAAAAAAAHAAAAAAAAAAAAAAAAAAAAAAAAAAAAAAAAAAAAf39/ACUAAABYAAAAAAAAAAAAAAAAAAAAAAAAAAAAAAAAAAAAAAAAAAAAAAAAAAAAAAAAAAAAAAA/AAAAAAAAAKCGAQAAAAAAAAAAAAAAAAAMAAAAAQAAAAAAAAAAAAAAAAAAAB8AAABUAAAA8/PzAP///wEAAAAAAAAAAAAAAAAAAAAAAAAAAAAAAAAAAAAAAAAAAAE9hQB/f38AWVlZA8zMzADAwP8Af39/AAAAAAAAAAAAAAAAAAAAAAAAAAAAIQAAABgAAAAUAAAA2CAAAFMCAADnNQAACwkAABAAAAAmAAAACAAAAP//////////"/>
               </a:ext>
             </a:extLst>
           </p:cNvSpPr>
@@ -12441,7 +12441,7 @@
             <a:spLocks noGrp="1" noChangeArrowheads="1"/>
             <a:extLst>
               <a:ext uri="smNativeData">
-                <pr:smNativeData xmlns:pr="smNativeData" xmlns="smNativeData" val="SMDATA_15_FUV5ZhMAAAAlAAAAZAAAAA0AAAAAkAAAAJAAAACQAAAAkAAAAAAAAAAAAAAAAAAAAAEAAABQAAAAAAAAAAAA4D8AAAAAAADgPwAAAAAAAOA/AAAAAAAA4D8AAAAAAADgPwAAAAAAAOA/AAAAAAAA4D8AAAAAAADgPwAAAAAAAOA/AAAAAAAA4D8CAAAAjAAAAAAAAAAAAAAAQoX0DP///wgAAAAAAAAAAAAAAAAAAAAAAAAAAAAAAAAAAAAAZAAAAAEAAABAAAAAAAAAAAAAAAAAAAAAAAAAAAAAAAAAAAAAAAAAAAAAAAAAAAAAAAAAAAAAAAAAAAAAAAAAAAAAAAAAAAAAAAAAAAAAAAAAAAAAAAAAAAAAAAAAAAAAFAAAADwAAAAAAAAAAAAAAAAAAAkUAAAAAQAAABQAAAAUAAAAFAAAAAEAAAAAAAAAZAAAAGQAAAAAAAAAZAAAAGQAAAAVAAAAYAAAAAAAAAAAAAAADwAAACADAAAAAAAAAAAAAAEAAACgMgAAVgcAAKr4//8BAAAAf39/AAEAAABkAAAAAAAAABQAAABAHwAAAAAAACYAAAAAAAAAwOD//wAAAAAmAAAAZAAAABYAAABMAAAAAAAAAAAAAAAEAAAAAAAAAAEAAABZWVkKAAAAACgAAAAoAAAAZAAAAGQAAAAAAAAAzMzMAAAAAABQAAAAUAAAAGQAAABkAAAAAAAAABcAAAAUAAAAAAAAAAAAAAD/fwAA/38AAAAAAAAJAAAABAAAAGl3mg4eAAAAaAAAAAAAAAAAAAAAAAAAAAAAAAAAAAAAECcAABAnAAAAAAAAAAAAAAAAAAAAAAAAAAAAAAAAAAAAAAAAAAAAABQAAAAAAAAAwMD/AAAAAABkAAAAMgAAAAAAAABkAAAAAAAAAH9/fwAKAAAAIgAAABgAAAAAAAAAAAAAAAAAAAAAAAAAAAAAAAAAAAAkAAAAJAAAAAAAAAAHAAAAAAAAAAAAAAAAAAAAAAAAAAAAAAAAAAAAf39/ACUAAABYAAAAAAAAAAAAAAAAAAAAAAAAAAAAAAAAAAAAAAAAAAAAAAAAAAAAAAAAAAAAAAA/AAAAAAAAAKCGAQAAAAAAAAAAAAAAAAAMAAAAAQAAAAAAAAAAAAAAAAAAAB8AAABUAAAAQoX0Bf///wEAAAAAAAAAAAAAAAAAAAAAAAAAAAAAAAAAAAAAAAAAAAAAAAJ/f38AWVlZA8zMzADAwP8Af39/AAAAAAAAAAAAAAAAAAAAAAAAAAAAIQAAABgAAAAUAAAAFAMAALYCAAB/NwAAvwoAABAAAAAmAAAACAAAADwwAAAAAAAA"/>
+                <pr:smNativeData xmlns:pr="smNativeData" xmlns="smNativeData" val="SMDATA_15_9kV5ZhMAAAAlAAAAZAAAAA0AAAAAkAAAAJAAAACQAAAAkAAAAAAAAAAAAAAAAAAAAAEAAABQAAAAAAAAAAAA4D8AAAAAAADgPwAAAAAAAOA/AAAAAAAA4D8AAAAAAADgPwAAAAAAAOA/AAAAAAAA4D8AAAAAAADgPwAAAAAAAOA/AAAAAAAA4D8CAAAAjAAAAAAAAAAAAAAAQoX0DP///wgAAAAAAAAAAAAAAAAAAAAAAAAAAAAAAAAAAAAAZAAAAAEAAABAAAAAAAAAAAAAAAAAAAAAAAAAAAAAAAAAAAAAAAAAAAAAAAAAAAAAAAAAAAAAAAAAAAAAAAAAAAAAAAAAAAAAAAAAAAAAAAAAAAAAAAAAAAAAAAAAAAAAFAAAADwAAAAAAAAAAAAAAAAAAAkUAAAAAQAAABQAAAAUAAAAFAAAAAEAAAAAAAAAZAAAAGQAAAAAAAAAZAAAAGQAAAAVAAAAYAAAAAAAAAAAAAAADwAAACADAAAAAAAAAAAAAAEAAACgMgAAVgcAAKr4//8BAAAAf39/AAEAAABkAAAAAAAAABQAAABAHwAAAAAAACYAAAAAAAAAwOD//wAAAAAmAAAAZAAAABYAAABMAAAAAAAAAAAAAAAEAAAAAAAAAAEAAABZWVkKAAAAACgAAAAoAAAAZAAAAGQAAAAAAAAAzMzMAAAAAABQAAAAUAAAAGQAAABkAAAAAAAAABcAAAAUAAAAAAAAAAAAAAD/fwAA/38AAAAAAAAJAAAABAAAAGl3mg4eAAAAaAAAAAAAAAAAAAAAAAAAAAAAAAAAAAAAECcAABAnAAAAAAAAAAAAAAAAAAAAAAAAAAAAAAAAAAAAAAAAAAAAABQAAAAAAAAAwMD/AAAAAABkAAAAMgAAAAAAAABkAAAAAAAAAH9/fwAKAAAAIgAAABgAAAAAAAAAAAAAAAAAAAAAAAAAAAAAAAAAAAAkAAAAJAAAAAAAAAAHAAAAAAAAAAAAAAAAAAAAAAAAAAAAAAAAAAAAf39/ACUAAABYAAAAAAAAAAAAAAAAAAAAAAAAAAAAAAAAAAAAAAAAAAAAAAAAAAAAAAAAAAAAAAA/AAAAAAAAAKCGAQAAAAAAAAAAAAAAAAAMAAAAAQAAAAAAAAAAAAAAAAAAAB8AAABUAAAAAAAABQAAAAEAAAAAAAAAAAAAAAAAAAAAAAAAAAAAAAAAAAAAAAAAAAAAAAJ/f38AWVlZA8zMzADAwP8Af39/AAAAAAAAAAAAAAAAAAAAAAAAAAAAIQAAABgAAAAUAAAAFAMAALYCAAB/NwAAvwoAABAAAAAmAAAACAAAADwwAAAAAAAA"/>
               </a:ext>
             </a:extLst>
           </p:cNvSpPr>
@@ -12631,7 +12631,7 @@
                 </a:tc>
                 <a:extLst>
                   <a:ext uri="smNativeData">
-                    <pr:rowheight xmlns="" xmlns:pr="smNativeData" dt="1719223573" type="min" val="381000"/>
+                    <pr:rowheight xmlns="" xmlns:pr="smNativeData" dt="1719223798" type="min" val="381000"/>
                   </a:ext>
                 </a:extLst>
               </a:tr>
@@ -12779,7 +12779,7 @@
                 </a:tc>
                 <a:extLst>
                   <a:ext uri="smNativeData">
-                    <pr:rowheight xmlns="" xmlns:pr="smNativeData" dt="1719223573" type="min" val="381000"/>
+                    <pr:rowheight xmlns="" xmlns:pr="smNativeData" dt="1719223798" type="min" val="381000"/>
                   </a:ext>
                 </a:extLst>
               </a:tr>
@@ -12927,7 +12927,7 @@
                 </a:tc>
                 <a:extLst>
                   <a:ext uri="smNativeData">
-                    <pr:rowheight xmlns="" xmlns:pr="smNativeData" dt="1719223573" type="min" val="381000"/>
+                    <pr:rowheight xmlns="" xmlns:pr="smNativeData" dt="1719223798" type="min" val="381000"/>
                   </a:ext>
                 </a:extLst>
               </a:tr>
@@ -13067,7 +13067,7 @@
                 </a:tc>
                 <a:extLst>
                   <a:ext uri="smNativeData">
-                    <pr:rowheight xmlns="" xmlns:pr="smNativeData" dt="1719223573" type="min" val="381000"/>
+                    <pr:rowheight xmlns="" xmlns:pr="smNativeData" dt="1719223798" type="min" val="381000"/>
                   </a:ext>
                 </a:extLst>
               </a:tr>
@@ -13081,7 +13081,7 @@
           <p:cNvSpPr>
             <a:extLst>
               <a:ext uri="smNativeData">
-                <pr:smNativeData xmlns:pr="smNativeData" xmlns="smNativeData" val="SMDATA_15_FUV5ZhMAAAAlAAAA9AEAAA0AAAAAOAEAAMYAAAA4AQAAxgAAAAAAAAABAAAAAAAAAAEAAABQAAAAe0ljtI6q2r8AAAAAAAD0PwAAAAAAAOA/AAAAAAAA4D8AAAAAAADgPwAAAAAAAOA/AAAAAAAA4D8AAAAAAADgPwAAAAAAAOA/AAAAAAAA4D8CAAAAjAAAAAEAAAAAAAAA8/PzAP///wgAAAAAAAAAAAAAAAAAAAAAAAAAAAAAAAAAAAAAeAAAAAEAAABAAAAAAAAAAAAAAABaAAAAAAAAAAAAAAAAAAAAAAAAAAAAAAAAAAAAAAAAAAAAAAAAAAAAAAAAAAAAAAAAAAAAAAAAAAAAAAAAAAAAAAAAAAAAAAAAAAAAFAAAADwAAAABAAAAAAAAAAE9hQAPAAAAAQAAACMAAAAjAAAAIwAAAB4AAAAAAAAASwAAAEsAAAAAAAAASwAAAEsAAAAVAAAAYAAAAAAAAAAAAAAADwAAACADAAAAAAAAAAAAAAEAAACgMgAAVgcAAKr4//8BAAAAf39/AAEAAABkAAAAAAAAABQAAABAHwAAAAAAACYAAAAAAAAAwOD//wAAAAAmAAAAZAAAABYAAABMAAAAAAAAAAAAAAAEAAAAAAAAAAEAAABZWVkKAAAAACgAAAAoAAAAZAAAAGQAAAAAAAAAzMzMAAAAAABQAAAAUAAAAGQAAABkAAAAAAAAABcAAAAUAAAAAAAAAAAAAAD/fwAA/38AAAAAAAAJAAAABAAAACgVFOgeAAAAaAAAAAAAAAAAAAAAAAAAAAAAAAAAAAAAECcAABAnAAAAAAAAAAAAAAAAAAAAAAAAAAAAAAAAAAAAAAAAAAAAABQAAAAAAAAAwMD/AAAAAABkAAAAMgAAAAAAAABkAAAAAAAAAH9/fwAKAAAAIgAAABgAAAAAAAAAAAAAAAAAAAAAAAAAAAAAAAAAAAAkAAAAJAAAAAAAAAAHAAAAAAAAAAAAAAAAAAAAAAAAAAAAAAAAAAAAf39/ACUAAABYAAAAAAAAAAAAAAAAAAAAAAAAAAAAAAAAAAAAAAAAAAAAAAAAAAAAAAAAAAAAAAA/AAAAAAAAAKCGAQAAAAAAAAAAAAAAAAAMAAAAAQAAAAAAAAAAAAAAAAAAAB8AAABUAAAA8/PzAP///wEAAAAAAAAAAAAAAAAAAAAAAAAAAAAAAAAAAAAAAAAAAAE9hQB/f38AWVlZA8zMzADAwP8Af39/AAAAAAAAAAAAAAAAAAAAAAAAAAAAIQAAABgAAAAUAAAA2CAAAFMCAADnNQAACwkAABAAAAAmAAAACAAAAP//////////"/>
+                <pr:smNativeData xmlns:pr="smNativeData" xmlns="smNativeData" val="SMDATA_15_9kV5ZhMAAAAlAAAA9AEAAA0AAAAAOAEAAMYAAAA4AQAAxgAAAAAAAAABAAAAAAAAAAEAAABQAAAAe0ljtI6q2r8AAAAAAAD0PwAAAAAAAOA/AAAAAAAA4D8AAAAAAADgPwAAAAAAAOA/AAAAAAAA4D8AAAAAAADgPwAAAAAAAOA/AAAAAAAA4D8CAAAAjAAAAAEAAAAAAAAA8/PzAP///wgAAAAAAAAAAAAAAAAAAAAAAAAAAAAAAAAAAAAAeAAAAAEAAABAAAAAAAAAAAAAAABaAAAAAAAAAAAAAAAAAAAAAAAAAAAAAAAAAAAAAAAAAAAAAAAAAAAAAAAAAAAAAAAAAAAAAAAAAAAAAAAAAAAAAAAAAAAAAAAAAAAAFAAAADwAAAABAAAAAAAAAAE9hQAPAAAAAQAAACMAAAAjAAAAIwAAAB4AAAAAAAAASwAAAEsAAAAAAAAASwAAAEsAAAAVAAAAYAAAAAAAAAAAAAAADwAAACADAAAAAAAAAAAAAAEAAACgMgAAVgcAAKr4//8BAAAAf39/AAEAAABkAAAAAAAAABQAAABAHwAAAAAAACYAAAAAAAAAwOD//wAAAAAmAAAAZAAAABYAAABMAAAAAAAAAAAAAAAEAAAAAAAAAAEAAABZWVkKAAAAACgAAAAoAAAAZAAAAGQAAAAAAAAAzMzMAAAAAABQAAAAUAAAAGQAAABkAAAAAAAAABcAAAAUAAAAAAAAAAAAAAD/fwAA/38AAAAAAAAJAAAABAAAACgVFOgeAAAAaAAAAAAAAAAAAAAAAAAAAAAAAAAAAAAAECcAABAnAAAAAAAAAAAAAAAAAAAAAAAAAAAAAAAAAAAAAAAAAAAAABQAAAAAAAAAwMD/AAAAAABkAAAAMgAAAAAAAABkAAAAAAAAAH9/fwAKAAAAIgAAABgAAAAAAAAAAAAAAAAAAAAAAAAAAAAAAAAAAAAkAAAAJAAAAAAAAAAHAAAAAAAAAAAAAAAAAAAAAAAAAAAAAAAAAAAAf39/ACUAAABYAAAAAAAAAAAAAAAAAAAAAAAAAAAAAAAAAAAAAAAAAAAAAAAAAAAAAAAAAAAAAAA/AAAAAAAAAKCGAQAAAAAAAAAAAAAAAAAMAAAAAQAAAAAAAAAAAAAAAAAAAB8AAABUAAAA8/PzAP///wEAAAAAAAAAAAAAAAAAAAAAAAAAAAAAAAAAAAAAAAAAAAE9hQB/f38AWVlZA8zMzADAwP8Af39/AAAAAAAAAAAAAAAAAAAAAAAAAAAAIQAAABgAAAAUAAAA2CAAAFMCAADnNQAACwkAABAAAAAmAAAACAAAAP//////////"/>
               </a:ext>
             </a:extLst>
           </p:cNvSpPr>
@@ -13185,7 +13185,7 @@
             <a:spLocks noGrp="1" noChangeArrowheads="1"/>
             <a:extLst>
               <a:ext uri="smNativeData">
-                <pr:smNativeData xmlns:pr="smNativeData" xmlns="smNativeData" val="SMDATA_15_FUV5ZhMAAAAlAAAAZAAAAA0AAAAAkAAAAJAAAACQAAAAkAAAAAAAAAAAAAAAAAAAAAEAAABQAAAAAAAAAAAA4D8AAAAAAADgPwAAAAAAAOA/AAAAAAAA4D8AAAAAAADgPwAAAAAAAOA/AAAAAAAA4D8AAAAAAADgPwAAAAAAAOA/AAAAAAAA4D8CAAAAjAAAAAAAAAAAAAAAQoX0DP///wgAAAAAAAAAAAAAAAAAAAAAAAAAAAAAAAAAAAAAZAAAAAEAAABAAAAAAAAAAAAAAAAAAAAAAAAAAAAAAAAAAAAAAAAAAAAAAAAAAAAAAAAAAAAAAAAAAAAAAAAAAAAAAAAAAAAAAAAAAAAAAAAAAAAAAAAAAAAAAAAAAAAAFAAAADwAAAAAAAAAAAAAAAAAAAkUAAAAAQAAABQAAAAUAAAAFAAAAAEAAAAAAAAAZAAAAGQAAAAAAAAAZAAAAGQAAAAVAAAAYAAAAAAAAAAAAAAADwAAACADAAAAAAAAAAAAAAEAAACgMgAAVgcAAKr4//8BAAAAf39/AAEAAABkAAAAAAAAABQAAABAHwAAAAAAACYAAAAAAAAAwOD//wAAAAAmAAAAZAAAABYAAABMAAAAAAAAAAAAAAAEAAAAAAAAAAEAAABZWVkKAAAAACgAAAAoAAAAZAAAAGQAAAAAAAAAzMzMAAAAAABQAAAAUAAAAGQAAABkAAAAAAAAABcAAAAUAAAAAAAAAAAAAAD/fwAA/38AAAAAAAAJAAAABAAAAMeGczoeAAAAaAAAAAAAAAAAAAAAAAAAAAAAAAAAAAAAECcAABAnAAAAAAAAAAAAAAAAAAAAAAAAAAAAAAAAAAAAAAAAAAAAABQAAAAAAAAAwMD/AAAAAABkAAAAMgAAAAAAAABkAAAAAAAAAH9/fwAKAAAAIgAAABgAAAAAAAAAAAAAAAAAAAAAAAAAAAAAAAAAAAAkAAAAJAAAAAAAAAAHAAAAAAAAAAAAAAAAAAAAAAAAAAAAAAAAAAAAf39/ACUAAABYAAAAAAAAAAAAAAAAAAAAAAAAAAAAAAAAAAAAAAAAAAAAAAAAAAAAAAAAAAAAAAA/AAAAAAAAAKCGAQAAAAAAAAAAAAAAAAAMAAAAAQAAAAAAAAAAAAAAAAAAAB8AAABUAAAAQoX0Bf///wEAAAAAAAAAAAAAAAAAAAAAAAAAAAAAAAAAAAAAAAAAAAAAAAJ/f38AWVlZA8zMzADAwP8Af39/AAAAAAAAAAAAAAAAAAAAAAAAAAAAIQAAABgAAAAUAAAAFAMAALYCAAB/NwAAvwoAABAAAAAmAAAACAAAADwwAAAAAAAA"/>
+                <pr:smNativeData xmlns:pr="smNativeData" xmlns="smNativeData" val="SMDATA_15_9kV5ZhMAAAAlAAAAZAAAAA0AAAAAkAAAAJAAAACQAAAAkAAAAAAAAAAAAAAAAAAAAAEAAABQAAAAAAAAAAAA4D8AAAAAAADgPwAAAAAAAOA/AAAAAAAA4D8AAAAAAADgPwAAAAAAAOA/AAAAAAAA4D8AAAAAAADgPwAAAAAAAOA/AAAAAAAA4D8CAAAAjAAAAAAAAAAAAAAAQoX0DP///wgAAAAAAAAAAAAAAAAAAAAAAAAAAAAAAAAAAAAAZAAAAAEAAABAAAAAAAAAAAAAAAAAAAAAAAAAAAAAAAAAAAAAAAAAAAAAAAAAAAAAAAAAAAAAAAAAAAAAAAAAAAAAAAAAAAAAAAAAAAAAAAAAAAAAAAAAAAAAAAAAAAAAFAAAADwAAAAAAAAAAAAAAAAAAAkUAAAAAQAAABQAAAAUAAAAFAAAAAEAAAAAAAAAZAAAAGQAAAAAAAAAZAAAAGQAAAAVAAAAYAAAAAAAAAAAAAAADwAAACADAAAAAAAAAAAAAAEAAACgMgAAVgcAAKr4//8BAAAAf39/AAEAAABkAAAAAAAAABQAAABAHwAAAAAAACYAAAAAAAAAwOD//wAAAAAmAAAAZAAAABYAAABMAAAAAAAAAAAAAAAEAAAAAAAAAAEAAABZWVkKAAAAACgAAAAoAAAAZAAAAGQAAAAAAAAAzMzMAAAAAABQAAAAUAAAAGQAAABkAAAAAAAAABcAAAAUAAAAAAAAAAAAAAD/fwAA/38AAAAAAAAJAAAABAAAAMeGczoeAAAAaAAAAAAAAAAAAAAAAAAAAAAAAAAAAAAAECcAABAnAAAAAAAAAAAAAAAAAAAAAAAAAAAAAAAAAAAAAAAAAAAAABQAAAAAAAAAwMD/AAAAAABkAAAAMgAAAAAAAABkAAAAAAAAAH9/fwAKAAAAIgAAABgAAAAAAAAAAAAAAAAAAAAAAAAAAAAAAAAAAAAkAAAAJAAAAAAAAAAHAAAAAAAAAAAAAAAAAAAAAAAAAAAAAAAAAAAAf39/ACUAAABYAAAAAAAAAAAAAAAAAAAAAAAAAAAAAAAAAAAAAAAAAAAAAAAAAAAAAAAAAAAAAAA/AAAAAAAAAKCGAQAAAAAAAAAAAAAAAAAMAAAAAQAAAAAAAAAAAAAAAAAAAB8AAABUAAAAAAAABQAAAAEAAAAAAAAAAAAAAAAAAAAAAAAAAAAAAAAAAAAAAAAAAAAAAAJ/f38AWVlZA8zMzADAwP8Af39/AAAAAAAAAAAAAAAAAAAAAAAAAAAAIQAAABgAAAAUAAAAFAMAALYCAAB/NwAAvwoAABAAAAAmAAAACAAAADwwAAAAAAAA"/>
               </a:ext>
             </a:extLst>
           </p:cNvSpPr>
@@ -13375,7 +13375,7 @@
                 </a:tc>
                 <a:extLst>
                   <a:ext uri="smNativeData">
-                    <pr:rowheight xmlns="" xmlns:pr="smNativeData" dt="1719223573" type="min" val="381000"/>
+                    <pr:rowheight xmlns="" xmlns:pr="smNativeData" dt="1719223798" type="min" val="381000"/>
                   </a:ext>
                 </a:extLst>
               </a:tr>
@@ -13523,7 +13523,7 @@
                 </a:tc>
                 <a:extLst>
                   <a:ext uri="smNativeData">
-                    <pr:rowheight xmlns="" xmlns:pr="smNativeData" dt="1719223573" type="min" val="381000"/>
+                    <pr:rowheight xmlns="" xmlns:pr="smNativeData" dt="1719223798" type="min" val="381000"/>
                   </a:ext>
                 </a:extLst>
               </a:tr>
@@ -13663,7 +13663,7 @@
                 </a:tc>
                 <a:extLst>
                   <a:ext uri="smNativeData">
-                    <pr:rowheight xmlns="" xmlns:pr="smNativeData" dt="1719223573" type="min" val="381000"/>
+                    <pr:rowheight xmlns="" xmlns:pr="smNativeData" dt="1719223798" type="min" val="381000"/>
                   </a:ext>
                 </a:extLst>
               </a:tr>
@@ -13677,7 +13677,7 @@
           <p:cNvSpPr>
             <a:extLst>
               <a:ext uri="smNativeData">
-                <pr:smNativeData xmlns:pr="smNativeData" xmlns="smNativeData" val="SMDATA_15_FUV5ZhMAAAAlAAAA9AEAAA0AAAAAOAEAAMYAAAA4AQAAxgAAAAAAAAABAAAAAAAAAAEAAABQAAAAR+aRPxh47L8Gu2Hbosz8vwAAAAAAAOA/AAAAAAAA4D8AAAAAAADgPwAAAAAAAOA/AAAAAAAA4D8AAAAAAADgPwAAAAAAAOA/AAAAAAAA4D8CAAAAjAAAAAEAAAAAAAAA8/PzAP///wgAAAAAAAAAAAAAAAAAAAAAAAAAAAAAAAAAAAAAeAAAAAEAAABAAAAAAAAAAAAAAABaAAAAAAAAAAAAAAAAAAAAAAAAAAAAAAAAAAAAAAAAAAAAAAAAAAAAAAAAAAAAAAAAAAAAAAAAAAAAAAAAAAAAAAAAAAAAAAAAAAAAFAAAADwAAAABAAAAAAAAAAE9hQAPAAAAAQAAACMAAAAjAAAAIwAAAB4AAAAAAAAASwAAAEsAAAAAAAAASwAAAEsAAAAVAAAAYAAAAAAAAAAAAAAADwAAACADAAAAAAAAAAAAAAEAAACgMgAAVgcAAKr4//8BAAAAf39/AAEAAABkAAAAAAAAABQAAABAHwAAAAAAACYAAAAAAAAAwOD//wAAAAAmAAAAZAAAABYAAABMAAAAAAAAAAAAAAAEAAAAAAAAAAEAAABZWVkKAAAAACgAAAAoAAAAZAAAAGQAAAAAAAAAzMzMAAAAAABQAAAAUAAAAGQAAABkAAAAAAAAABcAAAAUAAAAAAAAAAAAAAD/fwAA/38AAAAAAAAJAAAABAAAAAECAwAeAAAAaAAAAAAAAAAAAAAAAAAAAAAAAAAAAAAAECcAABAnAAAAAAAAAAAAAAAAAAAAAAAAAAAAAAAAAAAAAAAAAAAAABQAAAAAAAAAwMD/AAAAAABkAAAAMgAAAAAAAABkAAAAAAAAAH9/fwAKAAAAIgAAABgAAAAAAAAAAAAAAAAAAAAAAAAAAAAAAAAAAAAkAAAAJAAAAAAAAAAHAAAAAAAAAAAAAAAAAAAAAAAAAAAAAAAAAAAAf39/ACUAAABYAAAAAAAAAAAAAAAAAAAAAAAAAAAAAAAAAAAAAAAAAAAAAAAAAAAAAAAAAAAAAAA/AAAAAAAAAKCGAQAAAAAAAAAAAAAAAAAMAAAAAQAAAAAAAAAAAAAAAAAAAB8AAABUAAAA8/PzAP///wEAAAAAAAAAAAAAAAAAAAAAAAAAAAAAAAAAAAAAAAAAAAE9hQB/f38AWVlZA8zMzADAwP8Af39/AAAAAAAAAAAAAAAAAAAAAAAAAAAAIQAAABgAAAAUAAAAVR0AALMbAABkMgAAaiIAABAAAAAmAAAACAAAAP//////////"/>
+                <pr:smNativeData xmlns:pr="smNativeData" xmlns="smNativeData" val="SMDATA_15_9kV5ZhMAAAAlAAAA9AEAAA0AAAAAOAEAAMYAAAA4AQAAxgAAAAAAAAABAAAAAAAAAAEAAABQAAAAR+aRPxh47L8Gu2Hbosz8vwAAAAAAAOA/AAAAAAAA4D8AAAAAAADgPwAAAAAAAOA/AAAAAAAA4D8AAAAAAADgPwAAAAAAAOA/AAAAAAAA4D8CAAAAjAAAAAEAAAAAAAAA8/PzAP///wgAAAAAAAAAAAAAAAAAAAAAAAAAAAAAAAAAAAAAeAAAAAEAAABAAAAAAAAAAAAAAABaAAAAAAAAAAAAAAAAAAAAAAAAAAAAAAAAAAAAAAAAAAAAAAAAAAAAAAAAAAAAAAAAAAAAAAAAAAAAAAAAAAAAAAAAAAAAAAAAAAAAFAAAADwAAAABAAAAAAAAAAE9hQAPAAAAAQAAACMAAAAjAAAAIwAAAB4AAAAAAAAASwAAAEsAAAAAAAAASwAAAEsAAAAVAAAAYAAAAAAAAAAAAAAADwAAACADAAAAAAAAAAAAAAEAAACgMgAAVgcAAKr4//8BAAAAf39/AAEAAABkAAAAAAAAABQAAABAHwAAAAAAACYAAAAAAAAAwOD//wAAAAAmAAAAZAAAABYAAABMAAAAAAAAAAAAAAAEAAAAAAAAAAEAAABZWVkKAAAAACgAAAAoAAAAZAAAAGQAAAAAAAAAzMzMAAAAAABQAAAAUAAAAGQAAABkAAAAAAAAABcAAAAUAAAAAAAAAAAAAAD/fwAA/38AAAAAAAAJAAAABAAAAAECAwAeAAAAaAAAAAAAAAAAAAAAAAAAAAAAAAAAAAAAECcAABAnAAAAAAAAAAAAAAAAAAAAAAAAAAAAAAAAAAAAAAAAAAAAABQAAAAAAAAAwMD/AAAAAABkAAAAMgAAAAAAAABkAAAAAAAAAH9/fwAKAAAAIgAAABgAAAAAAAAAAAAAAAAAAAAAAAAAAAAAAAAAAAAkAAAAJAAAAAAAAAAHAAAAAAAAAAAAAAAAAAAAAAAAAAAAAAAAAAAAf39/ACUAAABYAAAAAAAAAAAAAAAAAAAAAAAAAAAAAAAAAAAAAAAAAAAAAAAAAAAAAAAAAAAAAAA/AAAAAAAAAKCGAQAAAAAAAAAAAAAAAAAMAAAAAQAAAAAAAAAAAAAAAAAAAB8AAABUAAAA8/PzAP///wEAAAAAAAAAAAAAAAAAAAAAAAAAAAAAAAAAAAAAAAAAAAE9hQB/f38AWVlZA8zMzADAwP8Af39/AAAAAAAAAAAAAAAAAAAAAAAAAAAAIQAAABgAAAAUAAAAVR0AALMbAABkMgAAaiIAABAAAAAmAAAACAAAAP//////////"/>
               </a:ext>
             </a:extLst>
           </p:cNvSpPr>
@@ -13781,7 +13781,7 @@
             <a:spLocks noGrp="1" noChangeArrowheads="1"/>
             <a:extLst>
               <a:ext uri="smNativeData">
-                <pr:smNativeData xmlns:pr="smNativeData" xmlns="smNativeData" val="SMDATA_15_FUV5ZhMAAAAlAAAAZAAAAA0AAAAAkAAAAJAAAACQAAAAkAAAAAAAAAAAAAAAAAAAAAEAAABQAAAAAAAAAAAA4D8AAAAAAADgPwAAAAAAAOA/AAAAAAAA4D8AAAAAAADgPwAAAAAAAOA/AAAAAAAA4D8AAAAAAADgPwAAAAAAAOA/AAAAAAAA4D8CAAAAjAAAAAAAAAAAAAAAQoX0DP///wgAAAAAAAAAAAAAAAAAAAAAAAAAAAAAAAAAAAAAZAAAAAEAAABAAAAAAAAAAAAAAAAAAAAAAAAAAAAAAAAAAAAAAAAAAAAAAAAAAAAAAAAAAAAAAAAAAAAAAAAAAAAAAAAAAAAAAAAAAAAAAAAAAAAAAAAAAAAAAAAAAAAAFAAAADwAAAAAAAAAAAAAAAAAAAkUAAAAAQAAABQAAAAUAAAAFAAAAAEAAAAAAAAAZAAAAGQAAAAAAAAAZAAAAGQAAAAVAAAAYAAAAAAAAAAAAAAADwAAACADAAAAAAAAAAAAAAEAAACgMgAAVgcAAKr4//8BAAAAf39/AAEAAABkAAAAAAAAABQAAABAHwAAAAAAACYAAAAAAAAAwOD//wAAAAAmAAAAZAAAABYAAABMAAAAAAAAAAAAAAAEAAAAAAAAAAEAAABZWVkKAAAAACgAAAAoAAAAZAAAAGQAAAAAAAAAzMzMAAAAAABQAAAAUAAAAGQAAABkAAAAAAAAABcAAAAUAAAAAAAAAAAAAAD/fwAA/38AAAAAAAAJAAAABAAAAGDhtuMeAAAAaAAAAAAAAAAAAAAAAAAAAAAAAAAAAAAAECcAABAnAAAAAAAAAAAAAAAAAAAAAAAAAAAAAAAAAAAAAAAAAAAAABQAAAAAAAAAwMD/AAAAAABkAAAAMgAAAAAAAABkAAAAAAAAAH9/fwAKAAAAIgAAABgAAAAAAAAAAAAAAAAAAAAAAAAAAAAAAAAAAAAkAAAAJAAAAAAAAAAHAAAAAAAAAAAAAAAAAAAAAAAAAAAAAAAAAAAAf39/ACUAAABYAAAAAAAAAAAAAAAAAAAAAAAAAAAAAAAAAAAAAAAAAAAAAAAAAAAAAAAAAAAAAAA/AAAAAAAAAKCGAQAAAAAAAAAAAAAAAAAMAAAAAQAAAAAAAAAAAAAAAAAAAB8AAABUAAAAAAAABQAAAAEAAAAAAAAAAAAAAAAAAAAAAAAAAAAAAAAAAAAAAAAAAAAAAAJ/f38AWVlZA8zMzADAwP8Af39/AAAAAAAAAAAAAAAAAAAAAAAAAAAAIQAAABgAAAAUAAAAFAMAALYCAAB/NwAAvwoAABAAAAAmAAAACAAAADwwAAAAAAAA"/>
+                <pr:smNativeData xmlns:pr="smNativeData" xmlns="smNativeData" val="SMDATA_15_9kV5ZhMAAAAlAAAAZAAAAA0AAAAAkAAAAJAAAACQAAAAkAAAAAAAAAAAAAAAAAAAAAEAAABQAAAAAAAAAAAA4D8AAAAAAADgPwAAAAAAAOA/AAAAAAAA4D8AAAAAAADgPwAAAAAAAOA/AAAAAAAA4D8AAAAAAADgPwAAAAAAAOA/AAAAAAAA4D8CAAAAjAAAAAAAAAAAAAAAQoX0DP///wgAAAAAAAAAAAAAAAAAAAAAAAAAAAAAAAAAAAAAZAAAAAEAAABAAAAAAAAAAAAAAAAAAAAAAAAAAAAAAAAAAAAAAAAAAAAAAAAAAAAAAAAAAAAAAAAAAAAAAAAAAAAAAAAAAAAAAAAAAAAAAAAAAAAAAAAAAAAAAAAAAAAAFAAAADwAAAAAAAAAAAAAAAAAAAkUAAAAAQAAABQAAAAUAAAAFAAAAAEAAAAAAAAAZAAAAGQAAAAAAAAAZAAAAGQAAAAVAAAAYAAAAAAAAAAAAAAADwAAACADAAAAAAAAAAAAAAEAAACgMgAAVgcAAKr4//8BAAAAf39/AAEAAABkAAAAAAAAABQAAABAHwAAAAAAACYAAAAAAAAAwOD//wAAAAAmAAAAZAAAABYAAABMAAAAAAAAAAAAAAAEAAAAAAAAAAEAAABZWVkKAAAAACgAAAAoAAAAZAAAAGQAAAAAAAAAzMzMAAAAAABQAAAAUAAAAGQAAABkAAAAAAAAABcAAAAUAAAAAAAAAAAAAAD/fwAA/38AAAAAAAAJAAAABAAAAGDhtuMeAAAAaAAAAAAAAAAAAAAAAAAAAAAAAAAAAAAAECcAABAnAAAAAAAAAAAAAAAAAAAAAAAAAAAAAAAAAAAAAAAAAAAAABQAAAAAAAAAwMD/AAAAAABkAAAAMgAAAAAAAABkAAAAAAAAAH9/fwAKAAAAIgAAABgAAAAAAAAAAAAAAAAAAAAAAAAAAAAAAAAAAAAkAAAAJAAAAAAAAAAHAAAAAAAAAAAAAAAAAAAAAAAAAAAAAAAAAAAAf39/ACUAAABYAAAAAAAAAAAAAAAAAAAAAAAAAAAAAAAAAAAAAAAAAAAAAAAAAAAAAAAAAAAAAAA/AAAAAAAAAKCGAQAAAAAAAAAAAAAAAAAMAAAAAQAAAAAAAAAAAAAAAAAAAB8AAABUAAAAAAAABQAAAAEAAAAAAAAAAAAAAAAAAAAAAAAAAAAAAAAAAAAAAAAAAAAAAAJ/f38AWVlZA8zMzADAwP8Af39/AAAAAAAAAAAAAAAAAAAAAAAAAAAAIQAAABgAAAAUAAAAFAMAALYCAAB/NwAAvwoAABAAAAAmAAAACAAAADwwAAAAAAAA"/>
               </a:ext>
             </a:extLst>
           </p:cNvSpPr>
@@ -13824,7 +13824,7 @@
             <a:spLocks noGrp="1" noChangeArrowheads="1"/>
             <a:extLst>
               <a:ext uri="smNativeData">
-                <pr:smNativeData xmlns:pr="smNativeData" xmlns="smNativeData" val="SMDATA_15_FUV5ZhMAAAAlAAAAZAAAAA0AAAAAkAAAAJAAAACQAAAAkAAAAAAAAAAAAAAAAAAAAAEAAABQAAAAAAAAAAAA4D8AAAAAAADgPwAAAAAAAOA/AAAAAAAA4D8AAAAAAADgPwAAAAAAAOA/AAAAAAAA4D8AAAAAAADgPwAAAAAAAOA/AAAAAAAA4D8CAAAAjAAAAAAAAAAAAAAAQoX0DP///wgAAAAAAAAAAAAAAAAAAAAAAAAAAAAAAAAAAAAAZAAAAAEAAABAAAAAAAAAAAAAAAAAAAAAAAAAAAAAAAAAAAAAAAAAAAAAAAAAAAAAAAAAAAAAAAAAAAAAAAAAAAAAAAAAAAAAAAAAAAAAAAAAAAAAAAAAAAAAAAAAAAAAFAAAADwAAAAAAAAAAAAAAAAAAAkUAAAAAQAAABQAAAAUAAAAFAAAAAEAAAAAAAAAZAAAAGQAAAAAAAAAZAAAAGQAAAAVAAAAYAAAAAAAAAAAAAAADwAAACADAAAAAAAAAAAAAAEAAACgMgAAVgcAAKr4//8BAAAAf39/AAEAAABkAAAAAAAAABQAAABAHwAAAAAAACYAAAAAAAAAwOD//wAAAAAmAAAAZAAAABYAAABMAAAAAAAAAAAAAAAEAAAAAAAAAAEAAABZWVkKAAAAACgAAAAoAAAAZAAAAGQAAAAAAAAAzMzMAAAAAABQAAAAUAAAAGQAAABkAAAAAAAAABcAAAAUAAAAAAAAAAAAAAD/fwAA/38AAAAAAAAJAAAABAAAAF8AYAAeAAAAaAAAAAAAAAAAAAAAAAAAAAAAAAAAAAAAECcAABAnAAAAAAAAAAAAAAAAAAAAAAAAAAAAAAAAAAAAAAAAAAAAABQAAAAAAAAAwMD/AAAAAABkAAAAMgAAAAAAAABkAAAAAAAAAH9/fwAKAAAAIgAAABgAAAAAAAAAAAAAAAAAAAAAAAAAAAAAAAAAAAAkAAAAJAAAAAAAAAAHAAAAAAAAAAAAAAAAAAAAAAAAAAAAAAAAAAAAf39/ACUAAABYAAAAAAAAAAAAAAAAAAAAAAAAAAAAAAAAAAAAAAAAAAAAAAAAAAAAAAAAAAAAAAA/AAAAAAAAAKCGAQAAAAAAAAAAAAAAAAAMAAAAAQAAAAAAAAAAAAAAAAAAAB8AAABUAAAAAAAABQAAAAEAAAAAAAAAAAAAAAAAAAAAAAAAAAAAAAAAAAAAAAAAAAAAAAJ/f38AWVlZA8zMzADAwP8Af39/AAAAAAAAAAAAAAAAAAAAAAAAAAAAIQAAABgAAAAUAAAAFAMAALMLAAB/NwAAuScAABAAAAAmAAAACAAAADwwAAAAAAAA"/>
+                <pr:smNativeData xmlns:pr="smNativeData" xmlns="smNativeData" val="SMDATA_15_9kV5ZhMAAAAlAAAAZAAAAA0AAAAAkAAAAJAAAACQAAAAkAAAAAAAAAAAAAAAAAAAAAEAAABQAAAAAAAAAAAA4D8AAAAAAADgPwAAAAAAAOA/AAAAAAAA4D8AAAAAAADgPwAAAAAAAOA/AAAAAAAA4D8AAAAAAADgPwAAAAAAAOA/AAAAAAAA4D8CAAAAjAAAAAAAAAAAAAAAQoX0DP///wgAAAAAAAAAAAAAAAAAAAAAAAAAAAAAAAAAAAAAZAAAAAEAAABAAAAAAAAAAAAAAAAAAAAAAAAAAAAAAAAAAAAAAAAAAAAAAAAAAAAAAAAAAAAAAAAAAAAAAAAAAAAAAAAAAAAAAAAAAAAAAAAAAAAAAAAAAAAAAAAAAAAAFAAAADwAAAAAAAAAAAAAAAAAAAkUAAAAAQAAABQAAAAUAAAAFAAAAAEAAAAAAAAAZAAAAGQAAAAAAAAAZAAAAGQAAAAVAAAAYAAAAAAAAAAAAAAADwAAACADAAAAAAAAAAAAAAEAAACgMgAAVgcAAKr4//8BAAAAf39/AAEAAABkAAAAAAAAABQAAABAHwAAAAAAACYAAAAAAAAAwOD//wAAAAAmAAAAZAAAABYAAABMAAAAAAAAAAAAAAAEAAAAAAAAAAEAAABZWVkKAAAAACgAAAAoAAAAZAAAAGQAAAAAAAAAzMzMAAAAAABQAAAAUAAAAGQAAABkAAAAAAAAABcAAAAUAAAAAAAAAAAAAAD/fwAA/38AAAAAAAAJAAAABAAAAF8AYAAeAAAAaAAAAAAAAAAAAAAAAAAAAAAAAAAAAAAAECcAABAnAAAAAAAAAAAAAAAAAAAAAAAAAAAAAAAAAAAAAAAAAAAAABQAAAAAAAAAwMD/AAAAAABkAAAAMgAAAAAAAABkAAAAAAAAAH9/fwAKAAAAIgAAABgAAAAAAAAAAAAAAAAAAAAAAAAAAAAAAAAAAAAkAAAAJAAAAAAAAAAHAAAAAAAAAAAAAAAAAAAAAAAAAAAAAAAAAAAAf39/ACUAAABYAAAAAAAAAAAAAAAAAAAAAAAAAAAAAAAAAAAAAAAAAAAAAAAAAAAAAAAAAAAAAAA/AAAAAAAAAKCGAQAAAAAAAAAAAAAAAAAMAAAAAQAAAAAAAAAAAAAAAAAAAB8AAABUAAAAAAAABQAAAAEAAAAAAAAAAAAAAAAAAAAAAAAAAAAAAAAAAAAAAAAAAAAAAAJ/f38AWVlZA8zMzADAwP8Af39/AAAAAAAAAAAAAAAAAAAAAAAAAAAAIQAAABgAAAAUAAAAFAMAALMLAAB/NwAAuScAABAAAAAmAAAACAAAADwwAAAAAAAA"/>
               </a:ext>
             </a:extLst>
           </p:cNvSpPr>
@@ -13861,7 +13861,7 @@
             <a:picLocks noChangeAspect="1"/>
             <a:extLst>
               <a:ext uri="smNativeData">
-                <pr:smNativeData xmlns:pr="smNativeData" xmlns="smNativeData" val="SMDATA_17_FUV5ZhMAAAAlAAAAEQAAAC8BAAAAkAAAAEgAAACQAAAASAAAAAAAAAAAAAAAAAAAAAEAAABQAAAAAAAAAAAA4D8AAAAAAADgPwAAAAAAAOA/AAAAAAAA4D8AAAAAAADgPwAAAAAAAOA/AAAAAAAA4D8AAAAAAADgPwAAAAAAAOA/AAAAAAAA4D8CAAAAjAAAAAAAAAAAAAAAQoX0DP///wgAAAAAAAAAAAAAAAAAAAAAAAAAAAAAAAAAAAAAZAAAAAEAAABAAAAAAAAAAAAAAAAAAAAAAAAAAAAAAAAAAAAAAAAAAAAAAAAAAAAAAAAAAAAAAAAAAAAAAAAAAAAAAAAAAAAAAAAAAAAAAAAAAAAAAAAAAAAAAAAAAAAAFAAAADwAAAAAAAAAAAAAAAAAAAkUAAAAAQAAABQAAAAUAAAAFAAAAAEAAAAAAAAAZAAAAGQAAAAAAAAAZAAAAGQAAAAVAAAAYAAAAAAAAAAAAAAADwAAACADAAAAAAAAAAAAAAEAAACgMgAAVgcAAKr4//8BAAAAf39/AAEAAABkAAAAAAAAABQAAABAHwAAAAAAACYAAAAAAAAAwOD//wAAAAAmAAAAZAAAABYAAABMAAAAAAAAAAAAAAAEAAAAAAAAAAEAAABZWVkKAAAAACgAAAAoAAAAZAAAAGQAAAAAAAAAzMzMAAAAAABQAAAAUAAAAGQAAABkAAAAAAAAAAcAAAA4AAAAAAAAAAAAAAAAAAAA////AAAAAAAAAAAAAAAAAAAAAAAAAAAAAAAAAAAAAABkAAAAZAAAAAAAAAAjAAAABAAAAGQAAAAXAAAAFAAAAAAAAAAAAAAA/38AAP9/AAAAAAAACQAAAAQAAAAOAAAAHgAAAGgAAAAAAAAAAAAAAAAAAAAAAAAAAAAAABAnAAAQJwAAAAAAAAAAAAAAAAAAAAAAAAAAAAAAAAAAAAAAAAAAAAAUAAAAAAAAAMDA/wAAAAAAZAAAADIAAAAAAAAAZAAAAAAAAAB/f38ACgAAACIAAAAYAAAAAAAAAAAAAAAAAAAAAAAAAAAAAAAAAAAAJAAAACQAAAAAAAAABwAAAAAAAAAAAAAAAAAAAAAAAAAAAAAAAAAAAH9/fwAlAAAAWAAAAAAAAAAAAAAAAAAAAAAAAAAAAAAAAAAAAAAAAAAAAAAAAAAAAAAAAAAAAAAAPwAAAAAAAACghgEAAAAAAAAAAAAAAAAADAAAAAEAAAAAAAAAAAAAAAAAAAAfAAAAVAAAAEKF9AX///8BAAAAAAAAAAAAAAAAAAAAAAAAAAAAAAAAAAAAAAAAAAAAAAACf39/AFlZWQPMzMwAwMD/AH9/fwAAAAAAAAAAAAAAAAD///8AAAAAACEAAAAYAAAAFAAAANwDAADmDgAAHSAAAMMlAAAQAAAAJgAAAAgAAAD//////////w=="/>
+                <pr:smNativeData xmlns:pr="smNativeData" xmlns="smNativeData" val="SMDATA_17_9kV5ZhMAAAAlAAAAEQAAAC8BAAAAkAAAAEgAAACQAAAASAAAAAAAAAAAAAAAAAAAAAEAAABQAAAAAAAAAAAA4D8AAAAAAADgPwAAAAAAAOA/AAAAAAAA4D8AAAAAAADgPwAAAAAAAOA/AAAAAAAA4D8AAAAAAADgPwAAAAAAAOA/AAAAAAAA4D8CAAAAjAAAAAAAAAAAAAAAQoX0DP///wgAAAAAAAAAAAAAAAAAAAAAAAAAAAAAAAAAAAAAZAAAAAEAAABAAAAAAAAAAAAAAAAAAAAAAAAAAAAAAAAAAAAAAAAAAAAAAAAAAAAAAAAAAAAAAAAAAAAAAAAAAAAAAAAAAAAAAAAAAAAAAAAAAAAAAAAAAAAAAAAAAAAAFAAAADwAAAAAAAAAAAAAAAAAAAkUAAAAAQAAABQAAAAUAAAAFAAAAAEAAAAAAAAAZAAAAGQAAAAAAAAAZAAAAGQAAAAVAAAAYAAAAAAAAAAAAAAADwAAACADAAAAAAAAAAAAAAEAAACgMgAAVgcAAKr4//8BAAAAf39/AAEAAABkAAAAAAAAABQAAABAHwAAAAAAACYAAAAAAAAAwOD//wAAAAAmAAAAZAAAABYAAABMAAAAAAAAAAAAAAAEAAAAAAAAAAEAAABZWVkKAAAAACgAAAAoAAAAZAAAAGQAAAAAAAAAzMzMAAAAAABQAAAAUAAAAGQAAABkAAAAAAAAAAcAAAA4AAAAAAAAAAAAAAAAAAAA////AAAAAAAAAAAAAAAAAAAAAAAAAAAAAAAAAAAAAABkAAAAZAAAAAAAAAAjAAAABAAAAGQAAAAXAAAAFAAAAAAAAAAAAAAA/38AAP9/AAAAAAAACQAAAAQAAAAOAAAAHgAAAGgAAAAAAAAAAAAAAAAAAAAAAAAAAAAAABAnAAAQJwAAAAAAAAAAAAAAAAAAAAAAAAAAAAAAAAAAAAAAAAAAAAAUAAAAAAAAAMDA/wAAAAAAZAAAADIAAAAAAAAAZAAAAAAAAAB/f38ACgAAACIAAAAYAAAAAAAAAAAAAAAAAAAAAAAAAAAAAAAAAAAAJAAAACQAAAAAAAAABwAAAAAAAAAAAAAAAAAAAAAAAAAAAAAAAAAAAH9/fwAlAAAAWAAAAAAAAAAAAAAAAAAAAAAAAAAAAAAAAAAAAAAAAAAAAAAAAAAAAAAAAAAAAAAAPwAAAAAAAACghgEAAAAAAAAAAAAAAAAADAAAAAEAAAAAAAAAAAAAAAAAAAAfAAAAVAAAAEKF9AX///8BAAAAAAAAAAAAAAAAAAAAAAAAAAAAAAAAAAAAAAAAAAAAAAACf39/AFlZWQPMzMwAwMD/AH9/fwAAAAAAAAAAAAAAAAD///8AAAAAACEAAAAYAAAAFAAAANwDAADmDgAAHSAAAMMlAAAQAAAAJgAAAAgAAAD//////////w=="/>
               </a:ext>
             </a:extLst>
           </p:cNvPicPr>
@@ -13927,7 +13927,7 @@
             <a:spLocks noGrp="1" noChangeArrowheads="1"/>
             <a:extLst>
               <a:ext uri="smNativeData">
-                <pr:smNativeData xmlns:pr="smNativeData" xmlns="smNativeData" val="SMDATA_15_FUV5ZhMAAAAlAAAAZAAAAA0AAAAAkAAAAJAAAACQAAAAkAAAAAAAAAAAAAAAAAAAAAEAAABQAAAAAAAAAAAA4D8AAAAAAADgPwAAAAAAAOA/AAAAAAAA4D8AAAAAAADgPwAAAAAAAOA/AAAAAAAA4D8AAAAAAADgPwAAAAAAAOA/AAAAAAAA4D8CAAAAjAAAAAAAAAAAAAAAQoX0DP///wgAAAAAAAAAAAAAAAAAAAAAAAAAAAAAAAAAAAAAZAAAAAEAAABAAAAAAAAAAAAAAAAAAAAAAAAAAAAAAAAAAAAAAAAAAAAAAAAAAAAAAAAAAAAAAAAAAAAAAAAAAAAAAAAAAAAAAAAAAAAAAAAAAAAAAAAAAAAAAAAAAAAAFAAAADwAAAAAAAAAAAAAAAAAAAkUAAAAAQAAABQAAAAUAAAAFAAAAAEAAAAAAAAAZAAAAGQAAAAAAAAAZAAAAGQAAAAVAAAAYAAAAAAAAAAAAAAADwAAACADAAAAAAAAAAAAAAEAAACgMgAAVgcAAKr4//8BAAAAf39/AAEAAABkAAAAAAAAABQAAABAHwAAAAAAACYAAAAAAAAAwOD//wAAAAAmAAAAZAAAABYAAABMAAAAAAAAAAAAAAAEAAAAAAAAAAEAAABZWVkKAAAAACgAAAAoAAAAZAAAAGQAAAAAAAAAzMzMAAAAAABQAAAAUAAAAGQAAABkAAAAAAAAABcAAAAUAAAAAAAAAAAAAAD/fwAA/38AAAAAAAAJAAAABAAAAAAAAAAeAAAAaAAAAAAAAAAAAAAAAAAAAAAAAAAAAAAAECcAABAnAAAAAAAAAAAAAAAAAAAAAAAAAAAAAAAAAAAAAAAAAAAAABQAAAAAAAAAwMD/AAAAAABkAAAAMgAAAAAAAABkAAAAAAAAAH9/fwAKAAAAIgAAABgAAAAAAAAAAAAAAAAAAAAAAAAAAAAAAAAAAAAkAAAAJAAAAAAAAAAHAAAAAAAAAAAAAAAAAAAAAAAAAAAAAAAAAAAAf39/ACUAAABYAAAAAAAAAAAAAAAAAAAAAAAAAAAAAAAAAAAAAAAAAAAAAAAAAAAAAAAAAAAAAAA/AAAAAAAAAKCGAQAAAAAAAAAAAAAAAAAMAAAAAQAAAAAAAAAAAAAAAAAAAB8AAABUAAAAAAAABQAAAAEAAAAAAAAAAAAAAAAAAAAAAAAAAAAAAAAAAAAAAAAAAAAAAAJ/f38AWVlZA8zMzADAwP8Af39/AAAAAAAAAAAAAAAAAAAAAAAAAAAAIQAAABgAAAAUAAAAFAMAALYCAAB/NwAAvwoAABAAAAAmAAAACAAAAAAAAAAAAAAA"/>
+                <pr:smNativeData xmlns:pr="smNativeData" xmlns="smNativeData" val="SMDATA_15_9kV5ZhMAAAAlAAAAZAAAAA0AAAAAkAAAAJAAAACQAAAAkAAAAAAAAAAAAAAAAAAAAAEAAABQAAAAAAAAAAAA4D8AAAAAAADgPwAAAAAAAOA/AAAAAAAA4D8AAAAAAADgPwAAAAAAAOA/AAAAAAAA4D8AAAAAAADgPwAAAAAAAOA/AAAAAAAA4D8CAAAAjAAAAAAAAAAAAAAAQoX0DP///wgAAAAAAAAAAAAAAAAAAAAAAAAAAAAAAAAAAAAAZAAAAAEAAABAAAAAAAAAAAAAAAAAAAAAAAAAAAAAAAAAAAAAAAAAAAAAAAAAAAAAAAAAAAAAAAAAAAAAAAAAAAAAAAAAAAAAAAAAAAAAAAAAAAAAAAAAAAAAAAAAAAAAFAAAADwAAAAAAAAAAAAAAAAAAAkUAAAAAQAAABQAAAAUAAAAFAAAAAEAAAAAAAAAZAAAAGQAAAAAAAAAZAAAAGQAAAAVAAAAYAAAAAAAAAAAAAAADwAAACADAAAAAAAAAAAAAAEAAACgMgAAVgcAAKr4//8BAAAAf39/AAEAAABkAAAAAAAAABQAAABAHwAAAAAAACYAAAAAAAAAwOD//wAAAAAmAAAAZAAAABYAAABMAAAAAAAAAAAAAAAEAAAAAAAAAAEAAABZWVkKAAAAACgAAAAoAAAAZAAAAGQAAAAAAAAAzMzMAAAAAABQAAAAUAAAAGQAAABkAAAAAAAAABcAAAAUAAAAAAAAAAAAAAD/fwAA/38AAAAAAAAJAAAABAAAAAAAAAAeAAAAaAAAAAAAAAAAAAAAAAAAAAAAAAAAAAAAECcAABAnAAAAAAAAAAAAAAAAAAAAAAAAAAAAAAAAAAAAAAAAAAAAABQAAAAAAAAAwMD/AAAAAABkAAAAMgAAAAAAAABkAAAAAAAAAH9/fwAKAAAAIgAAABgAAAAAAAAAAAAAAAAAAAAAAAAAAAAAAAAAAAAkAAAAJAAAAAAAAAAHAAAAAAAAAAAAAAAAAAAAAAAAAAAAAAAAAAAAf39/ACUAAABYAAAAAAAAAAAAAAAAAAAAAAAAAAAAAAAAAAAAAAAAAAAAAAAAAAAAAAAAAAAAAAA/AAAAAAAAAKCGAQAAAAAAAAAAAAAAAAAMAAAAAQAAAAAAAAAAAAAAAAAAAB8AAABUAAAAAAAABQAAAAEAAAAAAAAAAAAAAAAAAAAAAAAAAAAAAAAAAAAAAAAAAAAAAAJ/f38AWVlZA8zMzADAwP8Af39/AAAAAAAAAAAAAAAAAAAAAAAAAAAAIQAAABgAAAAUAAAAFAMAALYCAAB/NwAAvwoAABAAAAAmAAAACAAAAAAAAAAAAAAA"/>
               </a:ext>
             </a:extLst>
           </p:cNvSpPr>
@@ -13954,7 +13954,7 @@
             <a:spLocks noGrp="1" noChangeArrowheads="1"/>
             <a:extLst>
               <a:ext uri="smNativeData">
-                <pr:smNativeData xmlns:pr="smNativeData" xmlns="smNativeData" val="SMDATA_15_FUV5ZhMAAAAlAAAAZAAAAA0AAAAAkAAAAJAAAACQAAAAkAAAAAAAAAAAAAAAAAAAAAEAAABQAAAAAAAAAAAA4D8AAAAAAADgPwAAAAAAAOA/AAAAAAAA4D8AAAAAAADgPwAAAAAAAOA/AAAAAAAA4D8AAAAAAADgPwAAAAAAAOA/AAAAAAAA4D8CAAAAjAAAAAAAAAAAAAAAQoX0DP///wgAAAAAAAAAAAAAAAAAAAAAAAAAAAAAAAAAAAAAZAAAAAEAAABAAAAAAAAAAAAAAAAAAAAAAAAAAAAAAAAAAAAAAAAAAAAAAAAAAAAAAAAAAAAAAAAAAAAAAAAAAAAAAAAAAAAAAAAAAAAAAAAAAAAAAAAAAAAAAAAAAAAAFAAAADwAAAAAAAAAAAAAAAAAAAkUAAAAAQAAABQAAAAUAAAAFAAAAAEAAAAAAAAAZAAAAGQAAAAAAAAAZAAAAGQAAAAVAAAAYAAAAAAAAAAAAAAADwAAACADAAAAAAAAAAAAAAEAAACgMgAAVgcAAKr4//8BAAAAf39/AAEAAABkAAAAAAAAABQAAABAHwAAAAAAACYAAAAAAAAAwOD//wAAAAAmAAAAZAAAABYAAABMAAAAAAAAAAAAAAAEAAAAAAAAAAEAAABZWVkKAAAAACgAAAAoAAAAZAAAAGQAAAAAAAAAzMzMAAAAAABQAAAAUAAAAGQAAABkAAAAAAAAABcAAAAUAAAAAAAAAAAAAAD/fwAA/38AAAAAAAAJAAAABAAAAAAAAAAeAAAAaAAAAAAAAAAAAAAAAAAAAAAAAAAAAAAAECcAABAnAAAAAAAAAAAAAAAAAAAAAAAAAAAAAAAAAAAAAAAAAAAAABQAAAAAAAAAwMD/AAAAAABkAAAAMgAAAAAAAABkAAAAAAAAAH9/fwAKAAAAIgAAABgAAAAAAAAAAAAAAAAAAAAAAAAAAAAAAAAAAAAkAAAAJAAAAAAAAAAHAAAAAAAAAAAAAAAAAAAAAAAAAAAAAAAAAAAAf39/ACUAAABYAAAAAAAAAAAAAAAAAAAAAAAAAAAAAAAAAAAAAAAAAAAAAAAAAAAAAAAAAAAAAAA/AAAAAAAAAKCGAQAAAAAAAAAAAAAAAAAMAAAAAQAAAAAAAAAAAAAAAAAAAB8AAABUAAAAAAAABQAAAAEAAAAAAAAAAAAAAAAAAAAAAAAAAAAAAAAAAAAAAAAAAAAAAAJ/f38AWVlZA8zMzADAwP8Af39/AAAAAAAAAAAAAAAAAAAAAAAAAAAAIQAAABgAAAAUAAAAFAMAALMLAAB/NwAAuScAABAAAAAmAAAACAAAAAAAAAAAAAAA"/>
+                <pr:smNativeData xmlns:pr="smNativeData" xmlns="smNativeData" val="SMDATA_15_9kV5ZhMAAAAlAAAAZAAAAA0AAAAAkAAAAJAAAACQAAAAkAAAAAAAAAAAAAAAAAAAAAEAAABQAAAAAAAAAAAA4D8AAAAAAADgPwAAAAAAAOA/AAAAAAAA4D8AAAAAAADgPwAAAAAAAOA/AAAAAAAA4D8AAAAAAADgPwAAAAAAAOA/AAAAAAAA4D8CAAAAjAAAAAAAAAAAAAAAQoX0DP///wgAAAAAAAAAAAAAAAAAAAAAAAAAAAAAAAAAAAAAZAAAAAEAAABAAAAAAAAAAAAAAAAAAAAAAAAAAAAAAAAAAAAAAAAAAAAAAAAAAAAAAAAAAAAAAAAAAAAAAAAAAAAAAAAAAAAAAAAAAAAAAAAAAAAAAAAAAAAAAAAAAAAAFAAAADwAAAAAAAAAAAAAAAAAAAkUAAAAAQAAABQAAAAUAAAAFAAAAAEAAAAAAAAAZAAAAGQAAAAAAAAAZAAAAGQAAAAVAAAAYAAAAAAAAAAAAAAADwAAACADAAAAAAAAAAAAAAEAAACgMgAAVgcAAKr4//8BAAAAf39/AAEAAABkAAAAAAAAABQAAABAHwAAAAAAACYAAAAAAAAAwOD//wAAAAAmAAAAZAAAABYAAABMAAAAAAAAAAAAAAAEAAAAAAAAAAEAAABZWVkKAAAAACgAAAAoAAAAZAAAAGQAAAAAAAAAzMzMAAAAAABQAAAAUAAAAGQAAABkAAAAAAAAABcAAAAUAAAAAAAAAAAAAAD/fwAA/38AAAAAAAAJAAAABAAAAAAAAAAeAAAAaAAAAAAAAAAAAAAAAAAAAAAAAAAAAAAAECcAABAnAAAAAAAAAAAAAAAAAAAAAAAAAAAAAAAAAAAAAAAAAAAAABQAAAAAAAAAwMD/AAAAAABkAAAAMgAAAAAAAABkAAAAAAAAAH9/fwAKAAAAIgAAABgAAAAAAAAAAAAAAAAAAAAAAAAAAAAAAAAAAAAkAAAAJAAAAAAAAAAHAAAAAAAAAAAAAAAAAAAAAAAAAAAAAAAAAAAAf39/ACUAAABYAAAAAAAAAAAAAAAAAAAAAAAAAAAAAAAAAAAAAAAAAAAAAAAAAAAAAAAAAAAAAAA/AAAAAAAAAKCGAQAAAAAAAAAAAAAAAAAMAAAAAQAAAAAAAAAAAAAAAAAAAB8AAABUAAAAAAAABQAAAAEAAAAAAAAAAAAAAAAAAAAAAAAAAAAAAAAAAAAAAAAAAAAAAAJ/f38AWVlZA8zMzADAwP8Af39/AAAAAAAAAAAAAAAAAAAAAAAAAAAAIQAAABgAAAAUAAAAFAMAALMLAAB/NwAAuScAABAAAAAmAAAACAAAAAAAAAAAAAAA"/>
               </a:ext>
             </a:extLst>
           </p:cNvSpPr>
@@ -13987,7 +13987,7 @@
             <a:picLocks noChangeAspect="1"/>
             <a:extLst>
               <a:ext uri="smNativeData">
-                <pr:smNativeData xmlns:pr="smNativeData" xmlns="smNativeData" val="SMDATA_17_FUV5ZhMAAAAlAAAAEQAAAC8BAAAAkAAAAEgAAACQAAAASAAAAAAAAAAAAAAAAAAAAAEAAABQAAAAAAAAAAAA4D8AAAAAAADgPwAAAAAAAOA/AAAAAAAA4D8AAAAAAADgPwAAAAAAAOA/AAAAAAAA4D8AAAAAAADgPwAAAAAAAOA/AAAAAAAA4D8CAAAAjAAAAAAAAAAAAAAAQoX0DP///wgAAAAAAAAAAAAAAAAAAAAAAAAAAAAAAAAAAAAAZAAAAAEAAABAAAAAAAAAAAAAAAAAAAAAAAAAAAAAAAAAAAAAAAAAAAAAAAAAAAAAAAAAAAAAAAAAAAAAAAAAAAAAAAAAAAAAAAAAAAAAAAAAAAAAAAAAAAAAAAAAAAAAFAAAADwAAAAAAAAAAAAAAAAAAAkUAAAAAQAAABQAAAAUAAAAFAAAAAEAAAAAAAAAZAAAAGQAAAAAAAAAZAAAAGQAAAAVAAAAYAAAAAAAAAAAAAAADwAAACADAAAAAAAAAAAAAAEAAACgMgAAVgcAAKr4//8BAAAAf39/AAEAAABkAAAAAAAAABQAAABAHwAAAAAAACYAAAAAAAAAwOD//wAAAAAmAAAAZAAAABYAAABMAAAAAAAAAAAAAAAEAAAAAAAAAAEAAABZWVkKAAAAACgAAAAoAAAAZAAAAGQAAAAAAAAAzMzMAAAAAABQAAAAUAAAAGQAAABkAAAAAAAAAAcAAAA4AAAAAAAAAAAAAAAAAAAA////AAAAAAAAAAAAAAAAAAAAAAAAAAAAAAAAAAAAAABkAAAAZAAAAAAAAAAjAAAABAAAAGQAAAAXAAAAFAAAAAAAAAAAAAAA/38AAP9/AAAAAAAACQAAAAQAAADFAAAAHgAAAGgAAAAAAAAAAAAAAAAAAAAAAAAAAAAAABAnAAAQJwAAAAAAAAAAAAAAAAAAAAAAAAAAAAAAAAAAAAAAAAAAAAAUAAAAAAAAAMDA/wAAAAAAZAAAADIAAAAAAAAAZAAAAAAAAAB/f38ACgAAACIAAAAYAAAAAAAAAAAAAAAAAAAAAAAAAAAAAAAAAAAAJAAAACQAAAAAAAAABwAAAAAAAAAAAAAAAAAAAAAAAAAAAAAAAAAAAH9/fwAlAAAAWAAAAAAAAAAAAAAAAAAAAAAAAAAAAAAAAAAAAAAAAAAAAAAAAAAAAAAAAAAAAAAAPwAAAAAAAACghgEAAAAAAAAAAAAAAAAADAAAAAEAAAAAAAAAAAAAAAAAAAAfAAAAVAAAAEKF9AX///8BAAAAAAAAAAAAAAAAAAAAAAAAAAAAAAAAAAAAAAAAAAAAAAACf39/AFlZWQPMzMwAwMD/AH9/fwAAAAAAAAAAAAAAAAD///8AAAAAACEAAAAYAAAAFAAAAO8DAACGDgAAOyMAAKQlAAAQAAAAJgAAAAgAAAD//////////w=="/>
+                <pr:smNativeData xmlns:pr="smNativeData" xmlns="smNativeData" val="SMDATA_17_9kV5ZhMAAAAlAAAAEQAAAC8BAAAAkAAAAEgAAACQAAAASAAAAAAAAAAAAAAAAAAAAAEAAABQAAAAAAAAAAAA4D8AAAAAAADgPwAAAAAAAOA/AAAAAAAA4D8AAAAAAADgPwAAAAAAAOA/AAAAAAAA4D8AAAAAAADgPwAAAAAAAOA/AAAAAAAA4D8CAAAAjAAAAAAAAAAAAAAAQoX0DP///wgAAAAAAAAAAAAAAAAAAAAAAAAAAAAAAAAAAAAAZAAAAAEAAABAAAAAAAAAAAAAAAAAAAAAAAAAAAAAAAAAAAAAAAAAAAAAAAAAAAAAAAAAAAAAAAAAAAAAAAAAAAAAAAAAAAAAAAAAAAAAAAAAAAAAAAAAAAAAAAAAAAAAFAAAADwAAAAAAAAAAAAAAAAAAAkUAAAAAQAAABQAAAAUAAAAFAAAAAEAAAAAAAAAZAAAAGQAAAAAAAAAZAAAAGQAAAAVAAAAYAAAAAAAAAAAAAAADwAAACADAAAAAAAAAAAAAAEAAACgMgAAVgcAAKr4//8BAAAAf39/AAEAAABkAAAAAAAAABQAAABAHwAAAAAAACYAAAAAAAAAwOD//wAAAAAmAAAAZAAAABYAAABMAAAAAAAAAAAAAAAEAAAAAAAAAAEAAABZWVkKAAAAACgAAAAoAAAAZAAAAGQAAAAAAAAAzMzMAAAAAABQAAAAUAAAAGQAAABkAAAAAAAAAAcAAAA4AAAAAAAAAAAAAAAAAAAA////AAAAAAAAAAAAAAAAAAAAAAAAAAAAAAAAAAAAAABkAAAAZAAAAAAAAAAjAAAABAAAAGQAAAAXAAAAFAAAAAAAAAAAAAAA/38AAP9/AAAAAAAACQAAAAQAAADFAAAAHgAAAGgAAAAAAAAAAAAAAAAAAAAAAAAAAAAAABAnAAAQJwAAAAAAAAAAAAAAAAAAAAAAAAAAAAAAAAAAAAAAAAAAAAAUAAAAAAAAAMDA/wAAAAAAZAAAADIAAAAAAAAAZAAAAAAAAAB/f38ACgAAACIAAAAYAAAAAAAAAAAAAAAAAAAAAAAAAAAAAAAAAAAAJAAAACQAAAAAAAAABwAAAAAAAAAAAAAAAAAAAAAAAAAAAAAAAAAAAH9/fwAlAAAAWAAAAAAAAAAAAAAAAAAAAAAAAAAAAAAAAAAAAAAAAAAAAAAAAAAAAAAAAAAAAAAAPwAAAAAAAACghgEAAAAAAAAAAAAAAAAADAAAAAEAAAAAAAAAAAAAAAAAAAAfAAAAVAAAAEKF9AX///8BAAAAAAAAAAAAAAAAAAAAAAAAAAAAAAAAAAAAAAAAAAAAAAACf39/AFlZWQPMzMwAwMD/AH9/fwAAAAAAAAAAAAAAAAD///8AAAAAACEAAAAYAAAAFAAAAO8DAACGDgAAOyMAAKQlAAAQAAAAJgAAAAgAAAD//////////w=="/>
               </a:ext>
             </a:extLst>
           </p:cNvPicPr>
@@ -14403,6 +14403,47 @@
       </a:clrScheme>
       <a:clrMap bg1="lt1" tx1="dk1" bg2="lt2" tx2="dk2" accent1="accent1" accent2="accent2" accent3="accent3" accent4="accent4" accent5="accent5" accent6="accent6" hlink="hlink" folHlink="folHlink"/>
     </a:extraClrScheme>
+    <a:extraClrScheme>
+      <a:clrScheme name="Presentation 4">
+        <a:dk1>
+          <a:srgbClr val="000000"/>
+        </a:dk1>
+        <a:lt1>
+          <a:srgbClr val="FFFFFF"/>
+        </a:lt1>
+        <a:dk2>
+          <a:srgbClr val="EEEEEE"/>
+        </a:dk2>
+        <a:lt2>
+          <a:srgbClr val="595959"/>
+        </a:lt2>
+        <a:accent1>
+          <a:srgbClr val="4285F4"/>
+        </a:accent1>
+        <a:accent2>
+          <a:srgbClr val="212121"/>
+        </a:accent2>
+        <a:accent3>
+          <a:srgbClr val="78909C"/>
+        </a:accent3>
+        <a:accent4>
+          <a:srgbClr val="FFAB40"/>
+        </a:accent4>
+        <a:accent5>
+          <a:srgbClr val="0097A7"/>
+        </a:accent5>
+        <a:accent6>
+          <a:srgbClr val="EEFF41"/>
+        </a:accent6>
+        <a:hlink>
+          <a:srgbClr val="0097A7"/>
+        </a:hlink>
+        <a:folHlink>
+          <a:srgbClr val="0097A7"/>
+        </a:folHlink>
+      </a:clrScheme>
+      <a:clrMap bg1="lt1" tx1="dk1" bg2="lt2" tx2="dk2" accent1="accent1" accent2="accent2" accent3="accent3" accent4="accent4" accent5="accent5" accent6="accent6" hlink="hlink" folHlink="folHlink"/>
+    </a:extraClrScheme>
   </a:extraClrSchemeLst>
 </a:theme>
 </file>
@@ -14742,6 +14783,47 @@
     </a:extraClrScheme>
     <a:extraClrScheme>
       <a:clrScheme name="Presentation 3">
+        <a:dk1>
+          <a:srgbClr val="000000"/>
+        </a:dk1>
+        <a:lt1>
+          <a:srgbClr val="FFFFFF"/>
+        </a:lt1>
+        <a:dk2>
+          <a:srgbClr val="F3F3F3"/>
+        </a:dk2>
+        <a:lt2>
+          <a:srgbClr val="158158"/>
+        </a:lt2>
+        <a:accent1>
+          <a:srgbClr val="058DC7"/>
+        </a:accent1>
+        <a:accent2>
+          <a:srgbClr val="50B432"/>
+        </a:accent2>
+        <a:accent3>
+          <a:srgbClr val="ED561B"/>
+        </a:accent3>
+        <a:accent4>
+          <a:srgbClr val="EDEF00"/>
+        </a:accent4>
+        <a:accent5>
+          <a:srgbClr val="24CBE5"/>
+        </a:accent5>
+        <a:accent6>
+          <a:srgbClr val="64E572"/>
+        </a:accent6>
+        <a:hlink>
+          <a:srgbClr val="2200CC"/>
+        </a:hlink>
+        <a:folHlink>
+          <a:srgbClr val="551A8B"/>
+        </a:folHlink>
+      </a:clrScheme>
+      <a:clrMap bg1="lt1" tx1="dk1" bg2="lt2" tx2="dk2" accent1="accent1" accent2="accent2" accent3="accent3" accent4="accent4" accent5="accent5" accent6="accent6" hlink="hlink" folHlink="folHlink"/>
+    </a:extraClrScheme>
+    <a:extraClrScheme>
+      <a:clrScheme name="Presentation 4">
         <a:dk1>
           <a:srgbClr val="000000"/>
         </a:dk1>

--- a/project/Защита_проекта_Микросервис_на_основе_Apache_Kafka.pptx
+++ b/project/Защита_проекта_Микросервис_на_основе_Apache_Kafka.pptx
@@ -270,7 +270,7 @@
             <a:spLocks noGrp="1" noChangeArrowheads="1"/>
             <a:extLst>
               <a:ext uri="smNativeData">
-                <pr:smNativeData xmlns:pr="smNativeData" xmlns="smNativeData" val="SMDATA_15_9kV5ZhMAAAAlAAAACwAAAA0AAAAACAcAADgEAAAoIwAAUBkAAAAAAAAAAAAAAAAAAAEAAABQAAAAAAAAAAAA4D8AAAAAAADgPwAAAAAAAOA/AAAAAAAA4D8AAAAAAADgPwAAAAAAAOA/AAAAAAAA4D8AAAAAAADgPwAAAAAAAOA/AAAAAAAA4D8CAAAAjAAAAAAAAAAAAAAABY3HDP///wgAAAAAAAAAAAAAAAAAAAAAAAAAAAAAAAAAAAAAZAAAAAEAAABAAAAAAAAAAAAAAAAAAAAAAAAAAAAAAAAAAAAAAAAAAAAAAAAAAAAAAAAAAAAAAAAAAAAAAAAAAAAAAAAAAAAAAAAAAAAAAAAAAAAAAAAAAAAAAAAAAAAAFAAAADwAAAABAAAAAAAAAAAAAAAPAAAAAQAAACMAAAAjAAAAIwAAAB4AAAAAAAAASwAAAEsAAAAAAAAASwAAAEsAAAAVAAAAYAAAAAAAAAAAAAAADwAAACADAAAAAAAAAAAAAAEAAACgMgAAVgcAAKr4//8BAAAAf39/AAEAAABkAAAAAAAAABQAAABAHwAAAAAAACYAAAAAAAAAwOD//wAAAAAmAAAAZAAAABYAAABMAAAAAAAAAAAAAAAEAAAAAAAAAAEAAAAVgVgKAAAAACgAAAAoAAAAZAAAAGQAAAAAAAAAzMzMAAAAAABQAAAAUAAAAGQAAABkAAAAAAAAABcAAAAUAAAAAAAAAAAAAAD/fwAA/38AAAAAAAAJAAAABAAAACwAAAAeAAAAaAAAAAAAAAAAAAAAAAAAAAAAAAAAAAAAECcAABAnAAAAAAAAAAAAAAAAAAAAAAAAAAAAAAAAAAAAAAAAAAAAABQAAAAAAAAAwMD/AAAAAABkAAAAMgAAAAAAAABkAAAAAAAAAH9/fwAKAAAAIgAAABgAAAAAAAAAAAAAAAAAAAAAAAAAAAAAAAAAAAAkAAAAJAAAAAAAAAAHAAAAAAAAAAAAAAAAAAAAAAAAAAAAAAAAAAAAf39/ACUAAABYAAAAAAAAAAAAAAAAAAAAAAAAAAAAAAAAAAAAAAAAAAAAAAAAAAAAAAAAAAAAAAA/AAAAAAAAAKCGAQAAAAAAAAAAAAAAAAAMAAAAAQAAAAAAAAAAAAAAAAAAAB8AAABUAAAAAAAABQAAAAEAAAAAAAAAAAAAAAAAAAAAAAAAAAAAAAAAAAAAAAAAAAAAAAB/f38AAAAAA8zMzADAwP8Af39/AAAAAAAAAAAAAAAAAAAAAAAAAAAAIQAAABgAAAAUAAAACAcAADgEAAAoIwAAUBkAABAAAAAmAAAACAAAAAEPAAD/HwAA"/>
+                <pr:smNativeData xmlns:pr="smNativeData" xmlns="smNativeData" val="SMDATA_15_bQt8ZhMAAAAlAAAACwAAAA0AAAAACAcAADgEAAAoIwAAUBkAAAAAAAAAAAAAAAAAAAEAAABQAAAAAAAAAAAA4D8AAAAAAADgPwAAAAAAAOA/AAAAAAAA4D8AAAAAAADgPwAAAAAAAOA/AAAAAAAA4D8AAAAAAADgPwAAAAAAAOA/AAAAAAAA4D8CAAAAjAAAAAAAAAAAAAAABY3HDP///wgAAAAAAAAAAAAAAAAAAAAAAAAAAAAAAAAAAAAAZAAAAAEAAABAAAAAAAAAAAAAAAAAAAAAAAAAAAAAAAAAAAAAAAAAAAAAAAAAAAAAAAAAAAAAAAAAAAAAAAAAAAAAAAAAAAAAAAAAAAAAAAAAAAAAAAAAAAAAAAAAAAAAFAAAADwAAAABAAAAAAAAAAAAAAAPAAAAAQAAACMAAAAjAAAAIwAAAB4AAAAAAAAASwAAAEsAAAAAAAAASwAAAEsAAAAVAAAAYAAAAAAAAAAAAAAADwAAACADAAAAAAAAAAAAAAEAAACgMgAAVgcAAKr4//8BAAAAf39/AAEAAABkAAAAAAAAABQAAABAHwAAAAAAACYAAAAAAAAAwOD//wAAAAAmAAAAZAAAABYAAABMAAAAAAAAAAAAAAAEAAAAAAAAAAEAAAAVgVgKAAAAACgAAAAoAAAAZAAAAGQAAAAAAAAAzMzMAAAAAABQAAAAUAAAAGQAAABkAAAAAAAAABcAAAAUAAAAAAAAAAAAAAD/fwAA/38AAAAAAAAJAAAABAAAACwAAAAeAAAAaAAAAAAAAAAAAAAAAAAAAAAAAAAAAAAAECcAABAnAAAAAAAAAAAAAAAAAAAAAAAAAAAAAAAAAAAAAAAAAAAAABQAAAAAAAAAwMD/AAAAAABkAAAAMgAAAAAAAABkAAAAAAAAAH9/fwAKAAAAIgAAABgAAAAAAAAAAAAAAAAAAAAAAAAAAAAAAAAAAAAkAAAAJAAAAAAAAAAHAAAAAAAAAAAAAAAAAAAAAAAAAAAAAAAAAAAAf39/ACUAAABYAAAAAAAAAAAAAAAAAAAAAAAAAAAAAAAAAAAAAAAAAAAAAAAAAAAAAAAAAAAAAAA/AAAAAAAAAKCGAQAAAAAAAAAAAAAAAAAMAAAAAQAAAAAAAAAAAAAAAAAAAB8AAABUAAAAAAAABQAAAAEAAAAAAAAAAAAAAAAAAAAAAAAAAAAAAAAAAAAAAAAAAAAAAAB/f38AAAAAA8zMzADAwP8Af39/AAAAAAAAAAAAAAAAAAAAAAAAAAAAIQAAABgAAAAUAAAACAcAADgEAAAoIwAAUBkAABAAAAAmAAAACAAAAAEPAAD/HwAA"/>
               </a:ext>
             </a:extLst>
           </p:cNvSpPr>
@@ -325,7 +325,7 @@
             <a:spLocks noGrp="1" noChangeArrowheads="1"/>
             <a:extLst>
               <a:ext uri="smNativeData">
-                <pr:smNativeData xmlns:pr="smNativeData" xmlns="smNativeData" val="SMDATA_15_9kV5ZhMAAAAlAAAAZAAAAA0AAAAAkAAAAJAAAACQAAAAkAAAAAAAAAAAAAAAAAAAAAEAAABQAAAAAAAAAAAA4D8AAAAAAADgPwAAAAAAAOA/AAAAAAAA4D8AAAAAAADgPwAAAAAAAOA/AAAAAAAA4D8AAAAAAADgPwAAAAAAAOA/AAAAAAAA4D8CAAAAjAAAAAAAAAAAAAAABY3HDP///wgAAAAAAAAAAAAAAAAAAAAAAAAAAAAAAAAAAAAAZAAAAAEAAABAAAAAAAAAAAAAAAAAAAAAAAAAAAAAAAAAAAAAAAAAAAAAAAAAAAAAAAAAAAAAAAAAAAAAAAAAAAAAAAAAAAAAAAAAAAAAAAAAAAAAAAAAAAAAAAAAAAAAFAAAADwAAAAAAAAAAAAAAAAAAAkUAAAAAQAAABQAAAAUAAAAFAAAAAEAAAAAAAAAZAAAAGQAAAAAAAAAZAAAAGQAAAAVAAAAYAAAAAAAAAAAAAAADwAAACADAAAAAAAAAAAAAAEAAACgMgAAVgcAAKr4//8BAAAAf39/AAEAAABkAAAAAAAAABQAAABAHwAAAAAAACYAAAAAAAAAwOD//wAAAAAmAAAAZAAAABYAAABMAAAAAAAAAAAAAAAEAAAAAAAAAAEAAAAVgVgKAAAAACgAAAAoAAAAZAAAAGQAAAAAAAAAzMzMAAAAAABQAAAAUAAAAGQAAABkAAAAAAAAABcAAAAUAAAAAAAAAAAAAAD/fwAA/38AAAAAAAAJAAAABAAAAHsAfAAeAAAAaAAAAAAAAAAAAAAAAAAAAAAAAAAAAAAAECcAABAnAAAAAAAAAAAAAAAAAAAAAAAAAAAAAAAAAAAAAAAAAAAAABQAAAAAAAAAwMD/AAAAAABkAAAAMgAAAAAAAABkAAAAAAAAAH9/fwAKAAAAIgAAABgAAAAAAAAAAAAAAAAAAAAAAAAAAAAAAAAAAAAkAAAAJAAAAAAAAAAHAAAAAAAAAAAAAAAAAAAAAAAAAAAAAAAAAAAAf39/ACUAAABYAAAAAAAAAAAAAAAAAAAAAAAAAAAAAAAAAAAAAAAAAAAAAAAAAAAAAAAAAAAAAAA/AAAAAAAAAKCGAQAAAAAAAAAAAAAAAAAMAAAAAQAAAAAAAAAAAAAAAAAAAB8AAABUAAAAAAAABQAAAAEAAAAAAAAAAAAAAAAAAAAAAAAAAAAAAAAAAAAAAAAAAAAAAAJ/f38AAAAAA8zMzADAwP8Af39/AAAAAAAAAAAAAAAAAAAAAAAAAAAAIQAAABgAAAAUAAAAOAQAALgaAAD4JQAACDQAABAAAAAmAAAACAAAAL2/AAD/HwAA"/>
+                <pr:smNativeData xmlns:pr="smNativeData" xmlns="smNativeData" val="SMDATA_15_bQt8ZhMAAAAlAAAAZAAAAA0AAAAAkAAAAJAAAACQAAAAkAAAAAAAAAAAAAAAAAAAAAEAAABQAAAAAAAAAAAA4D8AAAAAAADgPwAAAAAAAOA/AAAAAAAA4D8AAAAAAADgPwAAAAAAAOA/AAAAAAAA4D8AAAAAAADgPwAAAAAAAOA/AAAAAAAA4D8CAAAAjAAAAAAAAAAAAAAABY3HDP///wgAAAAAAAAAAAAAAAAAAAAAAAAAAAAAAAAAAAAAZAAAAAEAAABAAAAAAAAAAAAAAAAAAAAAAAAAAAAAAAAAAAAAAAAAAAAAAAAAAAAAAAAAAAAAAAAAAAAAAAAAAAAAAAAAAAAAAAAAAAAAAAAAAAAAAAAAAAAAAAAAAAAAFAAAADwAAAAAAAAAAAAAAAAAAAkUAAAAAQAAABQAAAAUAAAAFAAAAAEAAAAAAAAAZAAAAGQAAAAAAAAAZAAAAGQAAAAVAAAAYAAAAAAAAAAAAAAADwAAACADAAAAAAAAAAAAAAEAAACgMgAAVgcAAKr4//8BAAAAf39/AAEAAABkAAAAAAAAABQAAABAHwAAAAAAACYAAAAAAAAAwOD//wAAAAAmAAAAZAAAABYAAABMAAAAAAAAAAAAAAAEAAAAAAAAAAEAAAAVgVgKAAAAACgAAAAoAAAAZAAAAGQAAAAAAAAAzMzMAAAAAABQAAAAUAAAAGQAAABkAAAAAAAAABcAAAAUAAAAAAAAAAAAAAD/fwAA/38AAAAAAAAJAAAABAAAAHsAfAAeAAAAaAAAAAAAAAAAAAAAAAAAAAAAAAAAAAAAECcAABAnAAAAAAAAAAAAAAAAAAAAAAAAAAAAAAAAAAAAAAAAAAAAABQAAAAAAAAAwMD/AAAAAABkAAAAMgAAAAAAAABkAAAAAAAAAH9/fwAKAAAAIgAAABgAAAAAAAAAAAAAAAAAAAAAAAAAAAAAAAAAAAAkAAAAJAAAAAAAAAAHAAAAAAAAAAAAAAAAAAAAAAAAAAAAAAAAAAAAf39/ACUAAABYAAAAAAAAAAAAAAAAAAAAAAAAAAAAAAAAAAAAAAAAAAAAAAAAAAAAAAAAAAAAAAA/AAAAAAAAAKCGAQAAAAAAAAAAAAAAAAAMAAAAAQAAAAAAAAAAAAAAAAAAAB8AAABUAAAAAAAABQAAAAEAAAAAAAAAAAAAAAAAAAAAAAAAAAAAAAAAAAAAAAAAAAAAAAJ/f38AAAAAA8zMzADAwP8Af39/AAAAAAAAAAAAAAAAAAAAAAAAAAAAIQAAABgAAAAUAAAAOAQAALgaAAD4JQAACDQAABAAAAAmAAAACAAAAL2/AAD/HwAA"/>
               </a:ext>
             </a:extLst>
           </p:cNvSpPr>
@@ -697,7 +697,7 @@
             <a:spLocks noGrp="1" noChangeArrowheads="1"/>
             <a:extLst>
               <a:ext uri="smNativeData">
-                <pr:smNativeData xmlns:pr="smNativeData" xmlns="smNativeData" val="SMDATA_15_9kV5ZhMAAAAlAAAACwAAAA0AAAAACAcAADgEAAAoIwAAUBkAAAAAAAAAAAAAAAAAAAEAAABQAAAAAAAAAAAA4D8AAAAAAADgPwAAAAAAAOA/AAAAAAAA4D8AAAAAAADgPwAAAAAAAOA/AAAAAAAA4D8AAAAAAADgPwAAAAAAAOA/AAAAAAAA4D8CAAAAjAAAAAAAAAAAAAAAQoX0DP///wgAAAAAAAAAAAAAAAAAAAAAAAAAAAAAAAAAAAAAZAAAAAEAAABAAAAAAAAAAAAAAAAAAAAAAAAAAAAAAAAAAAAAAAAAAAAAAAAAAAAAAAAAAAAAAAAAAAAAAAAAAAAAAAAAAAAAAAAAAAAAAAAAAAAAAAAAAAAAAAAAAAAAFAAAADwAAAABAAAAAAAAAAAAAAAPAAAAAQAAACMAAAAjAAAAIwAAAB4AAAAAAAAASwAAAEsAAAAAAAAASwAAAEsAAAAVAAAAYAAAAAAAAAAAAAAADwAAACADAAAAAAAAAAAAAAEAAACgMgAAVgcAAKr4//8BAAAAf39/AAEAAABkAAAAAAAAABQAAABAHwAAAAAAACYAAAAAAAAAwOD//wAAAAAmAAAAZAAAABYAAABMAAAAAAAAAAAAAAAEAAAAAAAAAAEAAABZWVkKAAAAACgAAAAoAAAAZAAAAGQAAAAAAAAAzMzMAAAAAABQAAAAUAAAAGQAAABkAAAAAAAAABcAAAAUAAAAAAAAAAAAAAD/fwAA/38AAAAAAAAJAAAABAAAAAAAAAAeAAAAaAAAAAAAAAAAAAAAAAAAAAAAAAAAAAAAECcAABAnAAAAAAAAAAAAAAAAAAAAAAAAAAAAAAAAAAAAAAAAAAAAABQAAAAAAAAAwMD/AAAAAABkAAAAMgAAAAAAAABkAAAAAAAAAH9/fwAKAAAAIgAAABgAAAAAAAAAAAAAAAAAAAAAAAAAAAAAAAAAAAAkAAAAJAAAAAAAAAAHAAAAAAAAAAAAAAAAAAAAAAAAAAAAAAAAAAAAf39/ACUAAABYAAAAAAAAAAAAAAAAAAAAAAAAAAAAAAAAAAAAAAAAAAAAAAAAAAAAAAAAAAAAAAA/AAAAAAAAAKCGAQAAAAAAAAAAAAAAAAAMAAAAAQAAAAAAAAAAAAAAAAAAAB8AAABUAAAAAAAABQAAAAEAAAAAAAAAAAAAAAAAAAAAAAAAAAAAAAAAAAAAAAAAAAAAAAB/f38AAAAAA8zMzADAwP8Af39/AAAAAAAAAAAAAAAAAAAAAAAAAAAAIQAAABgAAAAUAAAACAcAADgEAAAoIwAAUBkAABAAAAAmAAAACAAAAAEPAAAAAAAA"/>
+                <pr:smNativeData xmlns:pr="smNativeData" xmlns="smNativeData" val="SMDATA_15_bQt8ZhMAAAAlAAAACwAAAA0AAAAACAcAADgEAAAoIwAAUBkAAAAAAAAAAAAAAAAAAAEAAABQAAAAAAAAAAAA4D8AAAAAAADgPwAAAAAAAOA/AAAAAAAA4D8AAAAAAADgPwAAAAAAAOA/AAAAAAAA4D8AAAAAAADgPwAAAAAAAOA/AAAAAAAA4D8CAAAAjAAAAAAAAAAAAAAAQoX0DP///wgAAAAAAAAAAAAAAAAAAAAAAAAAAAAAAAAAAAAAZAAAAAEAAABAAAAAAAAAAAAAAAAAAAAAAAAAAAAAAAAAAAAAAAAAAAAAAAAAAAAAAAAAAAAAAAAAAAAAAAAAAAAAAAAAAAAAAAAAAAAAAAAAAAAAAAAAAAAAAAAAAAAAFAAAADwAAAABAAAAAAAAAAAAAAAPAAAAAQAAACMAAAAjAAAAIwAAAB4AAAAAAAAASwAAAEsAAAAAAAAASwAAAEsAAAAVAAAAYAAAAAAAAAAAAAAADwAAACADAAAAAAAAAAAAAAEAAACgMgAAVgcAAKr4//8BAAAAf39/AAEAAABkAAAAAAAAABQAAABAHwAAAAAAACYAAAAAAAAAwOD//wAAAAAmAAAAZAAAABYAAABMAAAAAAAAAAAAAAAEAAAAAAAAAAEAAABZWVkKAAAAACgAAAAoAAAAZAAAAGQAAAAAAAAAzMzMAAAAAABQAAAAUAAAAGQAAABkAAAAAAAAABcAAAAUAAAAAAAAAAAAAAD/fwAA/38AAAAAAAAJAAAABAAAAAAAAAAeAAAAaAAAAAAAAAAAAAAAAAAAAAAAAAAAAAAAECcAABAnAAAAAAAAAAAAAAAAAAAAAAAAAAAAAAAAAAAAAAAAAAAAABQAAAAAAAAAwMD/AAAAAABkAAAAMgAAAAAAAABkAAAAAAAAAH9/fwAKAAAAIgAAABgAAAAAAAAAAAAAAAAAAAAAAAAAAAAAAAAAAAAkAAAAJAAAAAAAAAAHAAAAAAAAAAAAAAAAAAAAAAAAAAAAAAAAAAAAf39/ACUAAABYAAAAAAAAAAAAAAAAAAAAAAAAAAAAAAAAAAAAAAAAAAAAAAAAAAAAAAAAAAAAAAA/AAAAAAAAAKCGAQAAAAAAAAAAAAAAAAAMAAAAAQAAAAAAAAAAAAAAAAAAAB8AAABUAAAAAAAABQAAAAEAAAAAAAAAAAAAAAAAAAAAAAAAAAAAAAAAAAAAAAAAAAAAAAB/f38AAAAAA8zMzADAwP8Af39/AAAAAAAAAAAAAAAAAAAAAAAAAAAAIQAAABgAAAAUAAAACAcAADgEAAAoIwAAUBkAABAAAAAmAAAACAAAAAEPAAAAAAAA"/>
               </a:ext>
             </a:extLst>
           </p:cNvSpPr>
@@ -743,7 +743,7 @@
             <a:spLocks noGrp="1" noChangeArrowheads="1"/>
             <a:extLst>
               <a:ext uri="smNativeData">
-                <pr:smNativeData xmlns:pr="smNativeData" xmlns="smNativeData" val="SMDATA_15_9kV5ZhMAAAAlAAAAZAAAAA0AAAAAkAAAAJAAAACQAAAAkAAAAAAAAAAAAAAAAAAAAAEAAABQAAAAAAAAAAAA4D8AAAAAAADgPwAAAAAAAOA/AAAAAAAA4D8AAAAAAADgPwAAAAAAAOA/AAAAAAAA4D8AAAAAAADgPwAAAAAAAOA/AAAAAAAA4D8CAAAAjAAAAAAAAAAAAAAAQoX0DP///wgAAAAAAAAAAAAAAAAAAAAAAAAAAAAAAAAAAAAAZAAAAAEAAABAAAAAAAAAAAAAAAAAAAAAAAAAAAAAAAAAAAAAAAAAAAAAAAAAAAAAAAAAAAAAAAAAAAAAAAAAAAAAAAAAAAAAAAAAAAAAAAAAAAAAAAAAAAAAAAAAAAAAFAAAADwAAAAAAAAAAAAAAAAAAAkUAAAAAQAAABQAAAAUAAAAFAAAAAEAAAAAAAAAZAAAAGQAAAAAAAAAZAAAAGQAAAAVAAAAYAAAAAAAAAAAAAAADwAAACADAAAAAAAAAAAAAAEAAACgMgAAVgcAAKr4//8BAAAAf39/AAEAAABkAAAAAAAAABQAAABAHwAAAAAAACYAAAAAAAAAwOD//wAAAAAmAAAAZAAAABYAAABMAAAAAAAAAAAAAAAEAAAAAAAAAAEAAABZWVkKAAAAACgAAAAoAAAAZAAAAGQAAAAAAAAAzMzMAAAAAABQAAAAUAAAAGQAAABkAAAAAAAAABcAAAAUAAAAAAAAAAAAAAD/fwAA/38AAAAAAAAJAAAABAAAAAAAAAAeAAAAaAAAAAAAAAAAAAAAAAAAAAAAAAAAAAAAECcAABAnAAAAAAAAAAAAAAAAAAAAAAAAAAAAAAAAAAAAAAAAAAAAABQAAAAAAAAAwMD/AAAAAABkAAAAMgAAAAAAAABkAAAAAAAAAH9/fwAKAAAAIgAAABgAAAAAAAAAAAAAAAAAAAAAAAAAAAAAAAAAAAAkAAAAJAAAAAAAAAAHAAAAAAAAAAAAAAAAAAAAAAAAAAAAAAAAAAAAf39/ACUAAABYAAAAAAAAAAAAAAAAAAAAAAAAAAAAAAAAAAAAAAAAAAAAAAAAAAAAAAAAAAAAAAA/AAAAAAAAAKCGAQAAAAAAAAAAAAAAAAAMAAAAAQAAAAAAAAAAAAAAAAAAAB8AAABUAAAAAAAABQAAAAEAAAAAAAAAAAAAAAAAAAAAAAAAAAAAAAAAAAAAAAAAAAAAAAJ/f38AAAAAA8zMzADAwP8Af39/AAAAAAAAAAAAAAAAAAAAAAAAAAAAIQAAABgAAAAUAAAAOAQAALgaAAD4JQAACDQAABAAAAAmAAAACAAAAL0/AAAAAAAA"/>
+                <pr:smNativeData xmlns:pr="smNativeData" xmlns="smNativeData" val="SMDATA_15_bQt8ZhMAAAAlAAAAZAAAAA0AAAAAkAAAAJAAAACQAAAAkAAAAAAAAAAAAAAAAAAAAAEAAABQAAAAAAAAAAAA4D8AAAAAAADgPwAAAAAAAOA/AAAAAAAA4D8AAAAAAADgPwAAAAAAAOA/AAAAAAAA4D8AAAAAAADgPwAAAAAAAOA/AAAAAAAA4D8CAAAAjAAAAAAAAAAAAAAAQoX0DP///wgAAAAAAAAAAAAAAAAAAAAAAAAAAAAAAAAAAAAAZAAAAAEAAABAAAAAAAAAAAAAAAAAAAAAAAAAAAAAAAAAAAAAAAAAAAAAAAAAAAAAAAAAAAAAAAAAAAAAAAAAAAAAAAAAAAAAAAAAAAAAAAAAAAAAAAAAAAAAAAAAAAAAFAAAADwAAAAAAAAAAAAAAAAAAAkUAAAAAQAAABQAAAAUAAAAFAAAAAEAAAAAAAAAZAAAAGQAAAAAAAAAZAAAAGQAAAAVAAAAYAAAAAAAAAAAAAAADwAAACADAAAAAAAAAAAAAAEAAACgMgAAVgcAAKr4//8BAAAAf39/AAEAAABkAAAAAAAAABQAAABAHwAAAAAAACYAAAAAAAAAwOD//wAAAAAmAAAAZAAAABYAAABMAAAAAAAAAAAAAAAEAAAAAAAAAAEAAABZWVkKAAAAACgAAAAoAAAAZAAAAGQAAAAAAAAAzMzMAAAAAABQAAAAUAAAAGQAAABkAAAAAAAAABcAAAAUAAAAAAAAAAAAAAD/fwAA/38AAAAAAAAJAAAABAAAAAAAAAAeAAAAaAAAAAAAAAAAAAAAAAAAAAAAAAAAAAAAECcAABAnAAAAAAAAAAAAAAAAAAAAAAAAAAAAAAAAAAAAAAAAAAAAABQAAAAAAAAAwMD/AAAAAABkAAAAMgAAAAAAAABkAAAAAAAAAH9/fwAKAAAAIgAAABgAAAAAAAAAAAAAAAAAAAAAAAAAAAAAAAAAAAAkAAAAJAAAAAAAAAAHAAAAAAAAAAAAAAAAAAAAAAAAAAAAAAAAAAAAf39/ACUAAABYAAAAAAAAAAAAAAAAAAAAAAAAAAAAAAAAAAAAAAAAAAAAAAAAAAAAAAAAAAAAAAA/AAAAAAAAAKCGAQAAAAAAAAAAAAAAAAAMAAAAAQAAAAAAAAAAAAAAAAAAAB8AAABUAAAAAAAABQAAAAEAAAAAAAAAAAAAAAAAAAAAAAAAAAAAAAAAAAAAAAAAAAAAAAJ/f38AAAAAA8zMzADAwP8Af39/AAAAAAAAAAAAAAAAAAAAAAAAAAAAIQAAABgAAAAUAAAAOAQAALgaAAD4JQAACDQAABAAAAAmAAAACAAAAL0/AAAAAAAA"/>
               </a:ext>
             </a:extLst>
           </p:cNvSpPr>
@@ -820,7 +820,7 @@
             <a:spLocks noGrp="1" noChangeArrowheads="1"/>
             <a:extLst>
               <a:ext uri="smNativeData">
-                <pr:smNativeData xmlns:pr="smNativeData" xmlns="smNativeData" val="SMDATA_15_9kV5ZhMAAAAlAAAACwAAAA0AAAAACAcAADgEAAAoIwAAUBkAAAAAAAAAAAAAAAAAAAEAAABQAAAAAAAAAAAA4D8AAAAAAADgPwAAAAAAAOA/AAAAAAAA4D8AAAAAAADgPwAAAAAAAOA/AAAAAAAA4D8AAAAAAADgPwAAAAAAAOA/AAAAAAAA4D8CAAAAjAAAAAAAAAAAAAAAQoX0DP///wgAAAAAAAAAAAAAAAAAAAAAAAAAAAAAAAAAAAAAZAAAAAEAAABAAAAAAAAAAAAAAAAAAAAAAAAAAAAAAAAAAAAAAAAAAAAAAAAAAAAAAAAAAAAAAAAAAAAAAAAAAAAAAAAAAAAAAAAAAAAAAAAAAAAAAAAAAAAAAAAAAAAAFAAAADwAAAABAAAAAAAAAAAAAAAPAAAAAQAAACMAAAAjAAAAIwAAAB4AAAAAAAAASwAAAEsAAAAAAAAASwAAAEsAAAAVAAAAYAAAAAAAAAAAAAAADwAAACADAAAAAAAAAAAAAAEAAACgMgAAVgcAAKr4//8BAAAAf39/AAEAAABkAAAAAAAAABQAAABAHwAAAAAAACYAAAAAAAAAwOD//wAAAAAmAAAAZAAAABYAAABMAAAAAAAAAAAAAAAEAAAAAAAAAAEAAABZWVkKAAAAACgAAAAoAAAAZAAAAGQAAAAAAAAAzMzMAAAAAABQAAAAUAAAAGQAAABkAAAAAAAAABcAAAAUAAAAAAAAAAAAAAD/fwAA/38AAAAAAAAJAAAABAAAALQAAAAeAAAAaAAAAAAAAAAAAAAAAAAAAAAAAAAAAAAAECcAABAnAAAAAAAAAAAAAAAAAAAAAAAAAAAAAAAAAAAAAAAAAAAAABQAAAAAAAAAwMD/AAAAAABkAAAAMgAAAAAAAABkAAAAAAAAAH9/fwAKAAAAIgAAABgAAAAAAAAAAAAAAAAAAAAAAAAAAAAAAAAAAAAkAAAAJAAAAAAAAAAHAAAAAAAAAAAAAAAAAAAAAAAAAAAAAAAAAAAAf39/ACUAAABYAAAAAAAAAAAAAAAAAAAAAAAAAAAAAAAAAAAAAAAAAAAAAAAAAAAAAAAAAAAAAAA/AAAAAAAAAKCGAQAAAAAAAAAAAAAAAAAMAAAAAQAAAAAAAAAAAAAAAAAAAB8AAABUAAAAAAAABQAAAAEAAAAAAAAAAAAAAAAAAAAAAAAAAAAAAAAAAAAAAAAAAAAAAAB/f38AAAAAA8zMzADAwP8Af39/AAAAAAAAAAAAAAAAAAAAAAAAAAAAIQAAABgAAAAUAAAACAcAADgEAAAoIwAAUBkAABAAAAAmAAAACAAAAAEPAAAAAAAA"/>
+                <pr:smNativeData xmlns:pr="smNativeData" xmlns="smNativeData" val="SMDATA_15_bQt8ZhMAAAAlAAAACwAAAA0AAAAACAcAADgEAAAoIwAAUBkAAAAAAAAAAAAAAAAAAAEAAABQAAAAAAAAAAAA4D8AAAAAAADgPwAAAAAAAOA/AAAAAAAA4D8AAAAAAADgPwAAAAAAAOA/AAAAAAAA4D8AAAAAAADgPwAAAAAAAOA/AAAAAAAA4D8CAAAAjAAAAAAAAAAAAAAAQoX0DP///wgAAAAAAAAAAAAAAAAAAAAAAAAAAAAAAAAAAAAAZAAAAAEAAABAAAAAAAAAAAAAAAAAAAAAAAAAAAAAAAAAAAAAAAAAAAAAAAAAAAAAAAAAAAAAAAAAAAAAAAAAAAAAAAAAAAAAAAAAAAAAAAAAAAAAAAAAAAAAAAAAAAAAFAAAADwAAAABAAAAAAAAAAAAAAAPAAAAAQAAACMAAAAjAAAAIwAAAB4AAAAAAAAASwAAAEsAAAAAAAAASwAAAEsAAAAVAAAAYAAAAAAAAAAAAAAADwAAACADAAAAAAAAAAAAAAEAAACgMgAAVgcAAKr4//8BAAAAf39/AAEAAABkAAAAAAAAABQAAABAHwAAAAAAACYAAAAAAAAAwOD//wAAAAAmAAAAZAAAABYAAABMAAAAAAAAAAAAAAAEAAAAAAAAAAEAAABZWVkKAAAAACgAAAAoAAAAZAAAAGQAAAAAAAAAzMzMAAAAAABQAAAAUAAAAGQAAABkAAAAAAAAABcAAAAUAAAAAAAAAAAAAAD/fwAA/38AAAAAAAAJAAAABAAAALQAAAAeAAAAaAAAAAAAAAAAAAAAAAAAAAAAAAAAAAAAECcAABAnAAAAAAAAAAAAAAAAAAAAAAAAAAAAAAAAAAAAAAAAAAAAABQAAAAAAAAAwMD/AAAAAABkAAAAMgAAAAAAAABkAAAAAAAAAH9/fwAKAAAAIgAAABgAAAAAAAAAAAAAAAAAAAAAAAAAAAAAAAAAAAAkAAAAJAAAAAAAAAAHAAAAAAAAAAAAAAAAAAAAAAAAAAAAAAAAAAAAf39/ACUAAABYAAAAAAAAAAAAAAAAAAAAAAAAAAAAAAAAAAAAAAAAAAAAAAAAAAAAAAAAAAAAAAA/AAAAAAAAAKCGAQAAAAAAAAAAAAAAAAAMAAAAAQAAAAAAAAAAAAAAAAAAAB8AAABUAAAAAAAABQAAAAEAAAAAAAAAAAAAAAAAAAAAAAAAAAAAAAAAAAAAAAAAAAAAAAB/f38AAAAAA8zMzADAwP8Af39/AAAAAAAAAAAAAAAAAAAAAAAAAAAAIQAAABgAAAAUAAAACAcAADgEAAAoIwAAUBkAABAAAAAmAAAACAAAAAEPAAAAAAAA"/>
               </a:ext>
             </a:extLst>
           </p:cNvSpPr>
@@ -866,7 +866,7 @@
             <a:spLocks noGrp="1" noChangeArrowheads="1"/>
             <a:extLst>
               <a:ext uri="smNativeData">
-                <pr:smNativeData xmlns:pr="smNativeData" xmlns="smNativeData" val="SMDATA_15_9kV5ZhMAAAAlAAAAZAAAAA0AAAAAkAAAAJAAAACQAAAAkAAAAAAAAAAAAAAAAAAAAAEAAABQAAAAAAAAAAAA4D8AAAAAAADgPwAAAAAAAOA/AAAAAAAA4D8AAAAAAADgPwAAAAAAAOA/AAAAAAAA4D8AAAAAAADgPwAAAAAAAOA/AAAAAAAA4D8CAAAAjAAAAAAAAAAAAAAAQoX0DP///wgAAAAAAAAAAAAAAAAAAAAAAAAAAAAAAAAAAAAAZAAAAAEAAABAAAAAAAAAAAAAAAAAAAAAAAAAAAAAAAAAAAAAAAAAAAAAAAAAAAAAAAAAAAAAAAAAAAAAAAAAAAAAAAAAAAAAAAAAAAAAAAAAAAAAAAAAAAAAAAAAAAAAFAAAADwAAAAAAAAAAAAAAAAAAAkUAAAAAQAAABQAAAAUAAAAFAAAAAEAAAAAAAAAZAAAAGQAAAAAAAAAZAAAAGQAAAAVAAAAYAAAAAAAAAAAAAAADwAAACADAAAAAAAAAAAAAAEAAACgMgAAVgcAAKr4//8BAAAAf39/AAEAAABkAAAAAAAAABQAAABAHwAAAAAAACYAAAAAAAAAwOD//wAAAAAmAAAAZAAAABYAAABMAAAAAAAAAAAAAAAEAAAAAAAAAAEAAABZWVkKAAAAACgAAAAoAAAAZAAAAGQAAAAAAAAAzMzMAAAAAABQAAAAUAAAAGQAAABkAAAAAAAAABcAAAAUAAAAAAAAAAAAAAD/fwAA/38AAAAAAAAJAAAABAAAAIK8UsUeAAAAaAAAAAAAAAAAAAAAAAAAAAAAAAAAAAAAECcAABAnAAAAAAAAAAAAAAAAAAAAAAAAAAAAAAAAAAAAAAAAAAAAABQAAAAAAAAAwMD/AAAAAABkAAAAMgAAAAAAAABkAAAAAAAAAH9/fwAKAAAAIgAAABgAAAAAAAAAAAAAAAAAAAAAAAAAAAAAAAAAAAAkAAAAJAAAAAAAAAAHAAAAAAAAAAAAAAAAAAAAAAAAAAAAAAAAAAAAf39/ACUAAABYAAAAAAAAAAAAAAAAAAAAAAAAAAAAAAAAAAAAAAAAAAAAAAAAAAAAAAAAAAAAAAA/AAAAAAAAAKCGAQAAAAAAAAAAAAAAAAAMAAAAAQAAAAAAAAAAAAAAAAAAAB8AAABUAAAAAAAABQAAAAEAAAAAAAAAAAAAAAAAAAAAAAAAAAAAAAAAAAAAAAAAAAAAAAJ/f38AAAAAA8zMzADAwP8Af39/AAAAAAAAAAAAAAAAAAAAAAAAAAAAIQAAABgAAAAUAAAAOAQAALgaAAD4JQAACDQAABAAAAAmAAAACAAAAL0/AAAAAAAA"/>
+                <pr:smNativeData xmlns:pr="smNativeData" xmlns="smNativeData" val="SMDATA_15_bQt8ZhMAAAAlAAAAZAAAAA0AAAAAkAAAAJAAAACQAAAAkAAAAAAAAAAAAAAAAAAAAAEAAABQAAAAAAAAAAAA4D8AAAAAAADgPwAAAAAAAOA/AAAAAAAA4D8AAAAAAADgPwAAAAAAAOA/AAAAAAAA4D8AAAAAAADgPwAAAAAAAOA/AAAAAAAA4D8CAAAAjAAAAAAAAAAAAAAAQoX0DP///wgAAAAAAAAAAAAAAAAAAAAAAAAAAAAAAAAAAAAAZAAAAAEAAABAAAAAAAAAAAAAAAAAAAAAAAAAAAAAAAAAAAAAAAAAAAAAAAAAAAAAAAAAAAAAAAAAAAAAAAAAAAAAAAAAAAAAAAAAAAAAAAAAAAAAAAAAAAAAAAAAAAAAFAAAADwAAAAAAAAAAAAAAAAAAAkUAAAAAQAAABQAAAAUAAAAFAAAAAEAAAAAAAAAZAAAAGQAAAAAAAAAZAAAAGQAAAAVAAAAYAAAAAAAAAAAAAAADwAAACADAAAAAAAAAAAAAAEAAACgMgAAVgcAAKr4//8BAAAAf39/AAEAAABkAAAAAAAAABQAAABAHwAAAAAAACYAAAAAAAAAwOD//wAAAAAmAAAAZAAAABYAAABMAAAAAAAAAAAAAAAEAAAAAAAAAAEAAABZWVkKAAAAACgAAAAoAAAAZAAAAGQAAAAAAAAAzMzMAAAAAABQAAAAUAAAAGQAAABkAAAAAAAAABcAAAAUAAAAAAAAAAAAAAD/fwAA/38AAAAAAAAJAAAABAAAAIK8UsUeAAAAaAAAAAAAAAAAAAAAAAAAAAAAAAAAAAAAECcAABAnAAAAAAAAAAAAAAAAAAAAAAAAAAAAAAAAAAAAAAAAAAAAABQAAAAAAAAAwMD/AAAAAABkAAAAMgAAAAAAAABkAAAAAAAAAH9/fwAKAAAAIgAAABgAAAAAAAAAAAAAAAAAAAAAAAAAAAAAAAAAAAAkAAAAJAAAAAAAAAAHAAAAAAAAAAAAAAAAAAAAAAAAAAAAAAAAAAAAf39/ACUAAABYAAAAAAAAAAAAAAAAAAAAAAAAAAAAAAAAAAAAAAAAAAAAAAAAAAAAAAAAAAAAAAA/AAAAAAAAAKCGAQAAAAAAAAAAAAAAAAAMAAAAAQAAAAAAAAAAAAAAAAAAAB8AAABUAAAAAAAABQAAAAEAAAAAAAAAAAAAAAAAAAAAAAAAAAAAAAAAAAAAAAAAAAAAAAJ/f38AAAAAA8zMzADAwP8Af39/AAAAAAAAAAAAAAAAAAAAAAAAAAAAIQAAABgAAAAUAAAAOAQAALgaAAD4JQAACDQAABAAAAAmAAAACAAAAL0/AAAAAAAA"/>
               </a:ext>
             </a:extLst>
           </p:cNvSpPr>
@@ -943,7 +943,7 @@
             <a:spLocks noGrp="1" noChangeArrowheads="1"/>
             <a:extLst>
               <a:ext uri="smNativeData">
-                <pr:smNativeData xmlns:pr="smNativeData" xmlns="smNativeData" val="SMDATA_15_9kV5ZhMAAAAlAAAACwAAAA0AAAAACAcAADgEAAAoIwAAUBkAAAAAAAAAAAAAAAAAAAEAAABQAAAAAAAAAAAA4D8AAAAAAADgPwAAAAAAAOA/AAAAAAAA4D8AAAAAAADgPwAAAAAAAOA/AAAAAAAA4D8AAAAAAADgPwAAAAAAAOA/AAAAAAAA4D8CAAAAjAAAAAAAAAAAAAAAQoX0DP///wgAAAAAAAAAAAAAAAAAAAAAAAAAAAAAAAAAAAAAZAAAAAEAAABAAAAAAAAAAAAAAAAAAAAAAAAAAAAAAAAAAAAAAAAAAAAAAAAAAAAAAAAAAAAAAAAAAAAAAAAAAAAAAAAAAAAAAAAAAAAAAAAAAAAAAAAAAAAAAAAAAAAAFAAAADwAAAABAAAAAAAAAAAAAAAPAAAAAQAAACMAAAAjAAAAIwAAAB4AAAAAAAAASwAAAEsAAAAAAAAASwAAAEsAAAAVAAAAYAAAAAAAAAAAAAAADwAAACADAAAAAAAAAAAAAAEAAACgMgAAVgcAAKr4//8BAAAAf39/AAEAAABkAAAAAAAAABQAAABAHwAAAAAAACYAAAAAAAAAwOD//wAAAAAmAAAAZAAAABYAAABMAAAAAAAAAAAAAAAEAAAAAAAAAAEAAABZWVkKAAAAACgAAAAoAAAAZAAAAGQAAAAAAAAAzMzMAAAAAABQAAAAUAAAAGQAAABkAAAAAAAAABcAAAAUAAAAAAAAAAAAAAD/fwAA/38AAAAAAAAJAAAABAAAAAAAAAAeAAAAaAAAAAAAAAAAAAAAAAAAAAAAAAAAAAAAECcAABAnAAAAAAAAAAAAAAAAAAAAAAAAAAAAAAAAAAAAAAAAAAAAABQAAAAAAAAAwMD/AAAAAABkAAAAMgAAAAAAAABkAAAAAAAAAH9/fwAKAAAAIgAAABgAAAAAAAAAAAAAAAAAAAAAAAAAAAAAAAAAAAAkAAAAJAAAAAAAAAAHAAAAAAAAAAAAAAAAAAAAAAAAAAAAAAAAAAAAf39/ACUAAABYAAAAAAAAAAAAAAAAAAAAAAAAAAAAAAAAAAAAAAAAAAAAAAAAAAAAAAAAAAAAAAA/AAAAAAAAAKCGAQAAAAAAAAAAAAAAAAAMAAAAAQAAAAAAAAAAAAAAAAAAAB8AAABUAAAAAAAABQAAAAEAAAAAAAAAAAAAAAAAAAAAAAAAAAAAAAAAAAAAAAAAAAAAAAB/f38AAAAAA8zMzADAwP8Af39/AAAAAAAAAAAAAAAAAAAAAAAAAAAAIQAAABgAAAAUAAAACAcAADgEAAAoIwAAUBkAABAAAAAmAAAACAAAAAEPAAAAAAAA"/>
+                <pr:smNativeData xmlns:pr="smNativeData" xmlns="smNativeData" val="SMDATA_15_bQt8ZhMAAAAlAAAACwAAAA0AAAAACAcAADgEAAAoIwAAUBkAAAAAAAAAAAAAAAAAAAEAAABQAAAAAAAAAAAA4D8AAAAAAADgPwAAAAAAAOA/AAAAAAAA4D8AAAAAAADgPwAAAAAAAOA/AAAAAAAA4D8AAAAAAADgPwAAAAAAAOA/AAAAAAAA4D8CAAAAjAAAAAAAAAAAAAAAQoX0DP///wgAAAAAAAAAAAAAAAAAAAAAAAAAAAAAAAAAAAAAZAAAAAEAAABAAAAAAAAAAAAAAAAAAAAAAAAAAAAAAAAAAAAAAAAAAAAAAAAAAAAAAAAAAAAAAAAAAAAAAAAAAAAAAAAAAAAAAAAAAAAAAAAAAAAAAAAAAAAAAAAAAAAAFAAAADwAAAABAAAAAAAAAAAAAAAPAAAAAQAAACMAAAAjAAAAIwAAAB4AAAAAAAAASwAAAEsAAAAAAAAASwAAAEsAAAAVAAAAYAAAAAAAAAAAAAAADwAAACADAAAAAAAAAAAAAAEAAACgMgAAVgcAAKr4//8BAAAAf39/AAEAAABkAAAAAAAAABQAAABAHwAAAAAAACYAAAAAAAAAwOD//wAAAAAmAAAAZAAAABYAAABMAAAAAAAAAAAAAAAEAAAAAAAAAAEAAABZWVkKAAAAACgAAAAoAAAAZAAAAGQAAAAAAAAAzMzMAAAAAABQAAAAUAAAAGQAAABkAAAAAAAAABcAAAAUAAAAAAAAAAAAAAD/fwAA/38AAAAAAAAJAAAABAAAAAAAAAAeAAAAaAAAAAAAAAAAAAAAAAAAAAAAAAAAAAAAECcAABAnAAAAAAAAAAAAAAAAAAAAAAAAAAAAAAAAAAAAAAAAAAAAABQAAAAAAAAAwMD/AAAAAABkAAAAMgAAAAAAAABkAAAAAAAAAH9/fwAKAAAAIgAAABgAAAAAAAAAAAAAAAAAAAAAAAAAAAAAAAAAAAAkAAAAJAAAAAAAAAAHAAAAAAAAAAAAAAAAAAAAAAAAAAAAAAAAAAAAf39/ACUAAABYAAAAAAAAAAAAAAAAAAAAAAAAAAAAAAAAAAAAAAAAAAAAAAAAAAAAAAAAAAAAAAA/AAAAAAAAAKCGAQAAAAAAAAAAAAAAAAAMAAAAAQAAAAAAAAAAAAAAAAAAAB8AAABUAAAAAAAABQAAAAEAAAAAAAAAAAAAAAAAAAAAAAAAAAAAAAAAAAAAAAAAAAAAAAB/f38AAAAAA8zMzADAwP8Af39/AAAAAAAAAAAAAAAAAAAAAAAAAAAAIQAAABgAAAAUAAAACAcAADgEAAAoIwAAUBkAABAAAAAmAAAACAAAAAEPAAAAAAAA"/>
               </a:ext>
             </a:extLst>
           </p:cNvSpPr>
@@ -989,7 +989,7 @@
             <a:spLocks noGrp="1" noChangeArrowheads="1"/>
             <a:extLst>
               <a:ext uri="smNativeData">
-                <pr:smNativeData xmlns:pr="smNativeData" xmlns="smNativeData" val="SMDATA_15_9kV5ZhMAAAAlAAAAZAAAAA0AAAAAkAAAAJAAAACQAAAAkAAAAAAAAAAAAAAAAAAAAAEAAABQAAAAAAAAAAAA4D8AAAAAAADgPwAAAAAAAOA/AAAAAAAA4D8AAAAAAADgPwAAAAAAAOA/AAAAAAAA4D8AAAAAAADgPwAAAAAAAOA/AAAAAAAA4D8CAAAAjAAAAAAAAAAAAAAAQoX0DP///wgAAAAAAAAAAAAAAAAAAAAAAAAAAAAAAAAAAAAAZAAAAAEAAABAAAAAAAAAAAAAAAAAAAAAAAAAAAAAAAAAAAAAAAAAAAAAAAAAAAAAAAAAAAAAAAAAAAAAAAAAAAAAAAAAAAAAAAAAAAAAAAAAAAAAAAAAAAAAAAAAAAAAFAAAADwAAAAAAAAAAAAAAAAAAAkUAAAAAQAAABQAAAAUAAAAFAAAAAEAAAAAAAAAZAAAAGQAAAAAAAAAZAAAAGQAAAAVAAAAYAAAAAAAAAAAAAAADwAAACADAAAAAAAAAAAAAAEAAACgMgAAVgcAAKr4//8BAAAAf39/AAEAAABkAAAAAAAAABQAAABAHwAAAAAAACYAAAAAAAAAwOD//wAAAAAmAAAAZAAAABYAAABMAAAAAAAAAAAAAAAEAAAAAAAAAAEAAABZWVkKAAAAACgAAAAoAAAAZAAAAGQAAAAAAAAAzMzMAAAAAABQAAAAUAAAAGQAAABkAAAAAAAAABcAAAAUAAAAAAAAAAAAAAD/fwAA/38AAAAAAAAJAAAABAAAAMGa1cUeAAAAaAAAAAAAAAAAAAAAAAAAAAAAAAAAAAAAECcAABAnAAAAAAAAAAAAAAAAAAAAAAAAAAAAAAAAAAAAAAAAAAAAABQAAAAAAAAAwMD/AAAAAABkAAAAMgAAAAAAAABkAAAAAAAAAH9/fwAKAAAAIgAAABgAAAAAAAAAAAAAAAAAAAAAAAAAAAAAAAAAAAAkAAAAJAAAAAAAAAAHAAAAAAAAAAAAAAAAAAAAAAAAAAAAAAAAAAAAf39/ACUAAABYAAAAAAAAAAAAAAAAAAAAAAAAAAAAAAAAAAAAAAAAAAAAAAAAAAAAAAAAAAAAAAA/AAAAAAAAAKCGAQAAAAAAAAAAAAAAAAAMAAAAAQAAAAAAAAAAAAAAAAAAAB8AAABUAAAAAAAABQAAAAEAAAAAAAAAAAAAAAAAAAAAAAAAAAAAAAAAAAAAAAAAAAAAAAJ/f38AAAAAA8zMzADAwP8Af39/AAAAAAAAAAAAAAAAAAAAAAAAAAAAIQAAABgAAAAUAAAAOAQAALgaAAD4JQAACDQAABAAAAAmAAAACAAAAL0/AAAAAAAA"/>
+                <pr:smNativeData xmlns:pr="smNativeData" xmlns="smNativeData" val="SMDATA_15_bQt8ZhMAAAAlAAAAZAAAAA0AAAAAkAAAAJAAAACQAAAAkAAAAAAAAAAAAAAAAAAAAAEAAABQAAAAAAAAAAAA4D8AAAAAAADgPwAAAAAAAOA/AAAAAAAA4D8AAAAAAADgPwAAAAAAAOA/AAAAAAAA4D8AAAAAAADgPwAAAAAAAOA/AAAAAAAA4D8CAAAAjAAAAAAAAAAAAAAAQoX0DP///wgAAAAAAAAAAAAAAAAAAAAAAAAAAAAAAAAAAAAAZAAAAAEAAABAAAAAAAAAAAAAAAAAAAAAAAAAAAAAAAAAAAAAAAAAAAAAAAAAAAAAAAAAAAAAAAAAAAAAAAAAAAAAAAAAAAAAAAAAAAAAAAAAAAAAAAAAAAAAAAAAAAAAFAAAADwAAAAAAAAAAAAAAAAAAAkUAAAAAQAAABQAAAAUAAAAFAAAAAEAAAAAAAAAZAAAAGQAAAAAAAAAZAAAAGQAAAAVAAAAYAAAAAAAAAAAAAAADwAAACADAAAAAAAAAAAAAAEAAACgMgAAVgcAAKr4//8BAAAAf39/AAEAAABkAAAAAAAAABQAAABAHwAAAAAAACYAAAAAAAAAwOD//wAAAAAmAAAAZAAAABYAAABMAAAAAAAAAAAAAAAEAAAAAAAAAAEAAABZWVkKAAAAACgAAAAoAAAAZAAAAGQAAAAAAAAAzMzMAAAAAABQAAAAUAAAAGQAAABkAAAAAAAAABcAAAAUAAAAAAAAAAAAAAD/fwAA/38AAAAAAAAJAAAABAAAAMGa1cUeAAAAaAAAAAAAAAAAAAAAAAAAAAAAAAAAAAAAECcAABAnAAAAAAAAAAAAAAAAAAAAAAAAAAAAAAAAAAAAAAAAAAAAABQAAAAAAAAAwMD/AAAAAABkAAAAMgAAAAAAAABkAAAAAAAAAH9/fwAKAAAAIgAAABgAAAAAAAAAAAAAAAAAAAAAAAAAAAAAAAAAAAAkAAAAJAAAAAAAAAAHAAAAAAAAAAAAAAAAAAAAAAAAAAAAAAAAAAAAf39/ACUAAABYAAAAAAAAAAAAAAAAAAAAAAAAAAAAAAAAAAAAAAAAAAAAAAAAAAAAAAAAAAAAAAA/AAAAAAAAAKCGAQAAAAAAAAAAAAAAAAAMAAAAAQAAAAAAAAAAAAAAAAAAAB8AAABUAAAAAAAABQAAAAEAAAAAAAAAAAAAAAAAAAAAAAAAAAAAAAAAAAAAAAAAAAAAAAJ/f38AAAAAA8zMzADAwP8Af39/AAAAAAAAAAAAAAAAAAAAAAAAAAAAIQAAABgAAAAUAAAAOAQAALgaAAD4JQAACDQAABAAAAAmAAAACAAAAL0/AAAAAAAA"/>
               </a:ext>
             </a:extLst>
           </p:cNvSpPr>
@@ -1066,7 +1066,7 @@
             <a:spLocks noGrp="1" noChangeArrowheads="1"/>
             <a:extLst>
               <a:ext uri="smNativeData">
-                <pr:smNativeData xmlns:pr="smNativeData" xmlns="smNativeData" val="SMDATA_15_9kV5ZhMAAAAlAAAACwAAAA0AAAAACAcAADgEAAAoIwAAUBkAAAAAAAAAAAAAAAAAAAEAAABQAAAAAAAAAAAA4D8AAAAAAADgPwAAAAAAAOA/AAAAAAAA4D8AAAAAAADgPwAAAAAAAOA/AAAAAAAA4D8AAAAAAADgPwAAAAAAAOA/AAAAAAAA4D8CAAAAjAAAAAAAAAAAAAAAQoX0DP///wgAAAAAAAAAAAAAAAAAAAAAAAAAAAAAAAAAAAAAZAAAAAEAAABAAAAAAAAAAAAAAAAAAAAAAAAAAAAAAAAAAAAAAAAAAAAAAAAAAAAAAAAAAAAAAAAAAAAAAAAAAAAAAAAAAAAAAAAAAAAAAAAAAAAAAAAAAAAAAAAAAAAAFAAAADwAAAABAAAAAAAAAAAAAAAPAAAAAQAAACMAAAAjAAAAIwAAAB4AAAAAAAAASwAAAEsAAAAAAAAASwAAAEsAAAAVAAAAYAAAAAAAAAAAAAAADwAAACADAAAAAAAAAAAAAAEAAACgMgAAVgcAAKr4//8BAAAAf39/AAEAAABkAAAAAAAAABQAAABAHwAAAAAAACYAAAAAAAAAwOD//wAAAAAmAAAAZAAAABYAAABMAAAAAAAAAAAAAAAEAAAAAAAAAAEAAABZWVkKAAAAACgAAAAoAAAAZAAAAGQAAAAAAAAAzMzMAAAAAABQAAAAUAAAAGQAAABkAAAAAAAAABcAAAAUAAAAAAAAAAAAAAD/fwAA/38AAAAAAAAJAAAABAAAAAAAAAAeAAAAaAAAAAAAAAAAAAAAAAAAAAAAAAAAAAAAECcAABAnAAAAAAAAAAAAAAAAAAAAAAAAAAAAAAAAAAAAAAAAAAAAABQAAAAAAAAAwMD/AAAAAABkAAAAMgAAAAAAAABkAAAAAAAAAH9/fwAKAAAAIgAAABgAAAAAAAAAAAAAAAAAAAAAAAAAAAAAAAAAAAAkAAAAJAAAAAAAAAAHAAAAAAAAAAAAAAAAAAAAAAAAAAAAAAAAAAAAf39/ACUAAABYAAAAAAAAAAAAAAAAAAAAAAAAAAAAAAAAAAAAAAAAAAAAAAAAAAAAAAAAAAAAAAA/AAAAAAAAAKCGAQAAAAAAAAAAAAAAAAAMAAAAAQAAAAAAAAAAAAAAAAAAAB8AAABUAAAAAAAABQAAAAEAAAAAAAAAAAAAAAAAAAAAAAAAAAAAAAAAAAAAAAAAAAAAAAB/f38AAAAAA8zMzADAwP8Af39/AAAAAAAAAAAAAAAAAAAAAAAAAAAAIQAAABgAAAAUAAAACAcAADgEAAAoIwAAUBkAABAAAAAmAAAACAAAAAEPAAAAAAAA"/>
+                <pr:smNativeData xmlns:pr="smNativeData" xmlns="smNativeData" val="SMDATA_15_bQt8ZhMAAAAlAAAACwAAAA0AAAAACAcAADgEAAAoIwAAUBkAAAAAAAAAAAAAAAAAAAEAAABQAAAAAAAAAAAA4D8AAAAAAADgPwAAAAAAAOA/AAAAAAAA4D8AAAAAAADgPwAAAAAAAOA/AAAAAAAA4D8AAAAAAADgPwAAAAAAAOA/AAAAAAAA4D8CAAAAjAAAAAAAAAAAAAAAQoX0DP///wgAAAAAAAAAAAAAAAAAAAAAAAAAAAAAAAAAAAAAZAAAAAEAAABAAAAAAAAAAAAAAAAAAAAAAAAAAAAAAAAAAAAAAAAAAAAAAAAAAAAAAAAAAAAAAAAAAAAAAAAAAAAAAAAAAAAAAAAAAAAAAAAAAAAAAAAAAAAAAAAAAAAAFAAAADwAAAABAAAAAAAAAAAAAAAPAAAAAQAAACMAAAAjAAAAIwAAAB4AAAAAAAAASwAAAEsAAAAAAAAASwAAAEsAAAAVAAAAYAAAAAAAAAAAAAAADwAAACADAAAAAAAAAAAAAAEAAACgMgAAVgcAAKr4//8BAAAAf39/AAEAAABkAAAAAAAAABQAAABAHwAAAAAAACYAAAAAAAAAwOD//wAAAAAmAAAAZAAAABYAAABMAAAAAAAAAAAAAAAEAAAAAAAAAAEAAABZWVkKAAAAACgAAAAoAAAAZAAAAGQAAAAAAAAAzMzMAAAAAABQAAAAUAAAAGQAAABkAAAAAAAAABcAAAAUAAAAAAAAAAAAAAD/fwAA/38AAAAAAAAJAAAABAAAAAAAAAAeAAAAaAAAAAAAAAAAAAAAAAAAAAAAAAAAAAAAECcAABAnAAAAAAAAAAAAAAAAAAAAAAAAAAAAAAAAAAAAAAAAAAAAABQAAAAAAAAAwMD/AAAAAABkAAAAMgAAAAAAAABkAAAAAAAAAH9/fwAKAAAAIgAAABgAAAAAAAAAAAAAAAAAAAAAAAAAAAAAAAAAAAAkAAAAJAAAAAAAAAAHAAAAAAAAAAAAAAAAAAAAAAAAAAAAAAAAAAAAf39/ACUAAABYAAAAAAAAAAAAAAAAAAAAAAAAAAAAAAAAAAAAAAAAAAAAAAAAAAAAAAAAAAAAAAA/AAAAAAAAAKCGAQAAAAAAAAAAAAAAAAAMAAAAAQAAAAAAAAAAAAAAAAAAAB8AAABUAAAAAAAABQAAAAEAAAAAAAAAAAAAAAAAAAAAAAAAAAAAAAAAAAAAAAAAAAAAAAB/f38AAAAAA8zMzADAwP8Af39/AAAAAAAAAAAAAAAAAAAAAAAAAAAAIQAAABgAAAAUAAAACAcAADgEAAAoIwAAUBkAABAAAAAmAAAACAAAAAEPAAAAAAAA"/>
               </a:ext>
             </a:extLst>
           </p:cNvSpPr>
@@ -1112,7 +1112,7 @@
             <a:spLocks noGrp="1" noChangeArrowheads="1"/>
             <a:extLst>
               <a:ext uri="smNativeData">
-                <pr:smNativeData xmlns:pr="smNativeData" xmlns="smNativeData" val="SMDATA_15_9kV5ZhMAAAAlAAAAZAAAAA0AAAAAkAAAAJAAAACQAAAAkAAAAAAAAAAAAAAAAAAAAAEAAABQAAAAAAAAAAAA4D8AAAAAAADgPwAAAAAAAOA/AAAAAAAA4D8AAAAAAADgPwAAAAAAAOA/AAAAAAAA4D8AAAAAAADgPwAAAAAAAOA/AAAAAAAA4D8CAAAAjAAAAAAAAAAAAAAAQoX0DP///wgAAAAAAAAAAAAAAAAAAAAAAAAAAAAAAAAAAAAAZAAAAAEAAABAAAAAAAAAAAAAAAAAAAAAAAAAAAAAAAAAAAAAAAAAAAAAAAAAAAAAAAAAAAAAAAAAAAAAAAAAAAAAAAAAAAAAAAAAAAAAAAAAAAAAAAAAAAAAAAAAAAAAFAAAADwAAAAAAAAAAAAAAAAAAAkUAAAAAQAAABQAAAAUAAAAFAAAAAEAAAAAAAAAZAAAAGQAAAAAAAAAZAAAAGQAAAAVAAAAYAAAAAAAAAAAAAAADwAAACADAAAAAAAAAAAAAAEAAACgMgAAVgcAAKr4//8BAAAAf39/AAEAAABkAAAAAAAAABQAAABAHwAAAAAAACYAAAAAAAAAwOD//wAAAAAmAAAAZAAAABYAAABMAAAAAAAAAAAAAAAEAAAAAAAAAAEAAABZWVkKAAAAACgAAAAoAAAAZAAAAGQAAAAAAAAAzMzMAAAAAABQAAAAUAAAAGQAAABkAAAAAAAAABcAAAAUAAAAAAAAAAAAAAD/fwAA/38AAAAAAAAJAAAABAAAAF8AYAAeAAAAaAAAAAAAAAAAAAAAAAAAAAAAAAAAAAAAECcAABAnAAAAAAAAAAAAAAAAAAAAAAAAAAAAAAAAAAAAAAAAAAAAABQAAAAAAAAAwMD/AAAAAABkAAAAMgAAAAAAAABkAAAAAAAAAH9/fwAKAAAAIgAAABgAAAAAAAAAAAAAAAAAAAAAAAAAAAAAAAAAAAAkAAAAJAAAAAAAAAAHAAAAAAAAAAAAAAAAAAAAAAAAAAAAAAAAAAAAf39/ACUAAABYAAAAAAAAAAAAAAAAAAAAAAAAAAAAAAAAAAAAAAAAAAAAAAAAAAAAAAAAAAAAAAA/AAAAAAAAAKCGAQAAAAAAAAAAAAAAAAAMAAAAAQAAAAAAAAAAAAAAAAAAAB8AAABUAAAAAAAABQAAAAEAAAAAAAAAAAAAAAAAAAAAAAAAAAAAAAAAAAAAAAAAAAAAAAJ/f38AAAAAA8zMzADAwP8Af39/AAAAAAAAAAAAAAAAAAAAAAAAAAAAIQAAABgAAAAUAAAAOAQAALgaAAD4JQAACDQAABAAAAAmAAAACAAAAL0/AAAAAAAA"/>
+                <pr:smNativeData xmlns:pr="smNativeData" xmlns="smNativeData" val="SMDATA_15_bQt8ZhMAAAAlAAAAZAAAAA0AAAAAkAAAAJAAAACQAAAAkAAAAAAAAAAAAAAAAAAAAAEAAABQAAAAAAAAAAAA4D8AAAAAAADgPwAAAAAAAOA/AAAAAAAA4D8AAAAAAADgPwAAAAAAAOA/AAAAAAAA4D8AAAAAAADgPwAAAAAAAOA/AAAAAAAA4D8CAAAAjAAAAAAAAAAAAAAAQoX0DP///wgAAAAAAAAAAAAAAAAAAAAAAAAAAAAAAAAAAAAAZAAAAAEAAABAAAAAAAAAAAAAAAAAAAAAAAAAAAAAAAAAAAAAAAAAAAAAAAAAAAAAAAAAAAAAAAAAAAAAAAAAAAAAAAAAAAAAAAAAAAAAAAAAAAAAAAAAAAAAAAAAAAAAFAAAADwAAAAAAAAAAAAAAAAAAAkUAAAAAQAAABQAAAAUAAAAFAAAAAEAAAAAAAAAZAAAAGQAAAAAAAAAZAAAAGQAAAAVAAAAYAAAAAAAAAAAAAAADwAAACADAAAAAAAAAAAAAAEAAACgMgAAVgcAAKr4//8BAAAAf39/AAEAAABkAAAAAAAAABQAAABAHwAAAAAAACYAAAAAAAAAwOD//wAAAAAmAAAAZAAAABYAAABMAAAAAAAAAAAAAAAEAAAAAAAAAAEAAABZWVkKAAAAACgAAAAoAAAAZAAAAGQAAAAAAAAAzMzMAAAAAABQAAAAUAAAAGQAAABkAAAAAAAAABcAAAAUAAAAAAAAAAAAAAD/fwAA/38AAAAAAAAJAAAABAAAAF8AYAAeAAAAaAAAAAAAAAAAAAAAAAAAAAAAAAAAAAAAECcAABAnAAAAAAAAAAAAAAAAAAAAAAAAAAAAAAAAAAAAAAAAAAAAABQAAAAAAAAAwMD/AAAAAABkAAAAMgAAAAAAAABkAAAAAAAAAH9/fwAKAAAAIgAAABgAAAAAAAAAAAAAAAAAAAAAAAAAAAAAAAAAAAAkAAAAJAAAAAAAAAAHAAAAAAAAAAAAAAAAAAAAAAAAAAAAAAAAAAAAf39/ACUAAABYAAAAAAAAAAAAAAAAAAAAAAAAAAAAAAAAAAAAAAAAAAAAAAAAAAAAAAAAAAAAAAA/AAAAAAAAAKCGAQAAAAAAAAAAAAAAAAAMAAAAAQAAAAAAAAAAAAAAAAAAAB8AAABUAAAAAAAABQAAAAEAAAAAAAAAAAAAAAAAAAAAAAAAAAAAAAAAAAAAAAAAAAAAAAJ/f38AAAAAA8zMzADAwP8Af39/AAAAAAAAAAAAAAAAAAAAAAAAAAAAIQAAABgAAAAUAAAAOAQAALgaAAD4JQAACDQAABAAAAAmAAAACAAAAL0/AAAAAAAA"/>
               </a:ext>
             </a:extLst>
           </p:cNvSpPr>
@@ -1189,7 +1189,7 @@
             <a:spLocks noGrp="1" noChangeArrowheads="1"/>
             <a:extLst>
               <a:ext uri="smNativeData">
-                <pr:smNativeData xmlns:pr="smNativeData" xmlns="smNativeData" val="SMDATA_15_9kV5ZhMAAAAlAAAACwAAAA0AAAAACAcAADgEAAAoIwAAUBkAAAAAAAAAAAAAAAAAAAEAAABQAAAAAAAAAAAA4D8AAAAAAADgPwAAAAAAAOA/AAAAAAAA4D8AAAAAAADgPwAAAAAAAOA/AAAAAAAA4D8AAAAAAADgPwAAAAAAAOA/AAAAAAAA4D8CAAAAjAAAAAAAAAAAAAAAQoX0DP///wgAAAAAAAAAAAAAAAAAAAAAAAAAAAAAAAAAAAAAZAAAAAEAAABAAAAAAAAAAAAAAAAAAAAAAAAAAAAAAAAAAAAAAAAAAAAAAAAAAAAAAAAAAAAAAAAAAAAAAAAAAAAAAAAAAAAAAAAAAAAAAAAAAAAAAAAAAAAAAAAAAAAAFAAAADwAAAABAAAAAAAAAAAAAAAPAAAAAQAAACMAAAAjAAAAIwAAAB4AAAAAAAAASwAAAEsAAAAAAAAASwAAAEsAAAAVAAAAYAAAAAAAAAAAAAAADwAAACADAAAAAAAAAAAAAAEAAACgMgAAVgcAAKr4//8BAAAAf39/AAEAAABkAAAAAAAAABQAAABAHwAAAAAAACYAAAAAAAAAwOD//wAAAAAmAAAAZAAAABYAAABMAAAAAAAAAAAAAAAEAAAAAAAAAAEAAABZWVkKAAAAACgAAAAoAAAAZAAAAGQAAAAAAAAAzMzMAAAAAABQAAAAUAAAAGQAAABkAAAAAAAAABcAAAAUAAAAAAAAAAAAAAD/fwAA/38AAAAAAAAJAAAABAAAAAAAAAAeAAAAaAAAAAAAAAAAAAAAAAAAAAAAAAAAAAAAECcAABAnAAAAAAAAAAAAAAAAAAAAAAAAAAAAAAAAAAAAAAAAAAAAABQAAAAAAAAAwMD/AAAAAABkAAAAMgAAAAAAAABkAAAAAAAAAH9/fwAKAAAAIgAAABgAAAAAAAAAAAAAAAAAAAAAAAAAAAAAAAAAAAAkAAAAJAAAAAAAAAAHAAAAAAAAAAAAAAAAAAAAAAAAAAAAAAAAAAAAf39/ACUAAABYAAAAAAAAAAAAAAAAAAAAAAAAAAAAAAAAAAAAAAAAAAAAAAAAAAAAAAAAAAAAAAA/AAAAAAAAAKCGAQAAAAAAAAAAAAAAAAAMAAAAAQAAAAAAAAAAAAAAAAAAAB8AAABUAAAAAAAABQAAAAEAAAAAAAAAAAAAAAAAAAAAAAAAAAAAAAAAAAAAAAAAAAAAAAB/f38AAAAAA8zMzADAwP8Af39/AAAAAAAAAAAAAAAAAAAAAAAAAAAAIQAAABgAAAAUAAAACAcAADgEAAAoIwAAUBkAABAAAAAmAAAACAAAAAEPAAAAAAAA"/>
+                <pr:smNativeData xmlns:pr="smNativeData" xmlns="smNativeData" val="SMDATA_15_bQt8ZhMAAAAlAAAACwAAAA0AAAAACAcAADgEAAAoIwAAUBkAAAAAAAAAAAAAAAAAAAEAAABQAAAAAAAAAAAA4D8AAAAAAADgPwAAAAAAAOA/AAAAAAAA4D8AAAAAAADgPwAAAAAAAOA/AAAAAAAA4D8AAAAAAADgPwAAAAAAAOA/AAAAAAAA4D8CAAAAjAAAAAAAAAAAAAAAQoX0DP///wgAAAAAAAAAAAAAAAAAAAAAAAAAAAAAAAAAAAAAZAAAAAEAAABAAAAAAAAAAAAAAAAAAAAAAAAAAAAAAAAAAAAAAAAAAAAAAAAAAAAAAAAAAAAAAAAAAAAAAAAAAAAAAAAAAAAAAAAAAAAAAAAAAAAAAAAAAAAAAAAAAAAAFAAAADwAAAABAAAAAAAAAAAAAAAPAAAAAQAAACMAAAAjAAAAIwAAAB4AAAAAAAAASwAAAEsAAAAAAAAASwAAAEsAAAAVAAAAYAAAAAAAAAAAAAAADwAAACADAAAAAAAAAAAAAAEAAACgMgAAVgcAAKr4//8BAAAAf39/AAEAAABkAAAAAAAAABQAAABAHwAAAAAAACYAAAAAAAAAwOD//wAAAAAmAAAAZAAAABYAAABMAAAAAAAAAAAAAAAEAAAAAAAAAAEAAABZWVkKAAAAACgAAAAoAAAAZAAAAGQAAAAAAAAAzMzMAAAAAABQAAAAUAAAAGQAAABkAAAAAAAAABcAAAAUAAAAAAAAAAAAAAD/fwAA/38AAAAAAAAJAAAABAAAAAAAAAAeAAAAaAAAAAAAAAAAAAAAAAAAAAAAAAAAAAAAECcAABAnAAAAAAAAAAAAAAAAAAAAAAAAAAAAAAAAAAAAAAAAAAAAABQAAAAAAAAAwMD/AAAAAABkAAAAMgAAAAAAAABkAAAAAAAAAH9/fwAKAAAAIgAAABgAAAAAAAAAAAAAAAAAAAAAAAAAAAAAAAAAAAAkAAAAJAAAAAAAAAAHAAAAAAAAAAAAAAAAAAAAAAAAAAAAAAAAAAAAf39/ACUAAABYAAAAAAAAAAAAAAAAAAAAAAAAAAAAAAAAAAAAAAAAAAAAAAAAAAAAAAAAAAAAAAA/AAAAAAAAAKCGAQAAAAAAAAAAAAAAAAAMAAAAAQAAAAAAAAAAAAAAAAAAAB8AAABUAAAAAAAABQAAAAEAAAAAAAAAAAAAAAAAAAAAAAAAAAAAAAAAAAAAAAAAAAAAAAB/f38AAAAAA8zMzADAwP8Af39/AAAAAAAAAAAAAAAAAAAAAAAAAAAAIQAAABgAAAAUAAAACAcAADgEAAAoIwAAUBkAABAAAAAmAAAACAAAAAEPAAAAAAAA"/>
               </a:ext>
             </a:extLst>
           </p:cNvSpPr>
@@ -1235,7 +1235,7 @@
             <a:spLocks noGrp="1" noChangeArrowheads="1"/>
             <a:extLst>
               <a:ext uri="smNativeData">
-                <pr:smNativeData xmlns:pr="smNativeData" xmlns="smNativeData" val="SMDATA_15_9kV5ZhMAAAAlAAAAZAAAAA0AAAAAkAAAAJAAAACQAAAAkAAAAAAAAAAAAAAAAAAAAAEAAABQAAAAAAAAAAAA4D8AAAAAAADgPwAAAAAAAOA/AAAAAAAA4D8AAAAAAADgPwAAAAAAAOA/AAAAAAAA4D8AAAAAAADgPwAAAAAAAOA/AAAAAAAA4D8CAAAAjAAAAAAAAAAAAAAAQoX0DP///wgAAAAAAAAAAAAAAAAAAAAAAAAAAAAAAAAAAAAAZAAAAAEAAABAAAAAAAAAAAAAAAAAAAAAAAAAAAAAAAAAAAAAAAAAAAAAAAAAAAAAAAAAAAAAAAAAAAAAAAAAAAAAAAAAAAAAAAAAAAAAAAAAAAAAAAAAAAAAAAAAAAAAFAAAADwAAAAAAAAAAAAAAAAAAAkUAAAAAQAAABQAAAAUAAAAFAAAAAEAAAAAAAAAZAAAAGQAAAAAAAAAZAAAAGQAAAAVAAAAYAAAAAAAAAAAAAAADwAAACADAAAAAAAAAAAAAAEAAACgMgAAVgcAAKr4//8BAAAAf39/AAEAAABkAAAAAAAAABQAAABAHwAAAAAAACYAAAAAAAAAwOD//wAAAAAmAAAAZAAAABYAAABMAAAAAAAAAAAAAAAEAAAAAAAAAAEAAABZWVkKAAAAACgAAAAoAAAAZAAAAGQAAAAAAAAAzMzMAAAAAABQAAAAUAAAAGQAAABkAAAAAAAAABcAAAAUAAAAAAAAAAAAAAD/fwAA/38AAAAAAAAJAAAABAAAAM/Y+1ceAAAAaAAAAAAAAAAAAAAAAAAAAAAAAAAAAAAAECcAABAnAAAAAAAAAAAAAAAAAAAAAAAAAAAAAAAAAAAAAAAAAAAAABQAAAAAAAAAwMD/AAAAAABkAAAAMgAAAAAAAABkAAAAAAAAAH9/fwAKAAAAIgAAABgAAAAAAAAAAAAAAAAAAAAAAAAAAAAAAAAAAAAkAAAAJAAAAAAAAAAHAAAAAAAAAAAAAAAAAAAAAAAAAAAAAAAAAAAAf39/ACUAAABYAAAAAAAAAAAAAAAAAAAAAAAAAAAAAAAAAAAAAAAAAAAAAAAAAAAAAAAAAAAAAAA/AAAAAAAAAKCGAQAAAAAAAAAAAAAAAAAMAAAAAQAAAAAAAAAAAAAAAAAAAB8AAABUAAAAAAAABQAAAAEAAAAAAAAAAAAAAAAAAAAAAAAAAAAAAAAAAAAAAAAAAAAAAAJ/f38AAAAAA8zMzADAwP8Af39/AAAAAAAAAAAAAAAAAAAAAAAAAAAAIQAAABgAAAAUAAAAOAQAALgaAAD4JQAACDQAABAAAAAmAAAACAAAAL0/AAAAAAAA"/>
+                <pr:smNativeData xmlns:pr="smNativeData" xmlns="smNativeData" val="SMDATA_15_bQt8ZhMAAAAlAAAAZAAAAA0AAAAAkAAAAJAAAACQAAAAkAAAAAAAAAAAAAAAAAAAAAEAAABQAAAAAAAAAAAA4D8AAAAAAADgPwAAAAAAAOA/AAAAAAAA4D8AAAAAAADgPwAAAAAAAOA/AAAAAAAA4D8AAAAAAADgPwAAAAAAAOA/AAAAAAAA4D8CAAAAjAAAAAAAAAAAAAAAQoX0DP///wgAAAAAAAAAAAAAAAAAAAAAAAAAAAAAAAAAAAAAZAAAAAEAAABAAAAAAAAAAAAAAAAAAAAAAAAAAAAAAAAAAAAAAAAAAAAAAAAAAAAAAAAAAAAAAAAAAAAAAAAAAAAAAAAAAAAAAAAAAAAAAAAAAAAAAAAAAAAAAAAAAAAAFAAAADwAAAAAAAAAAAAAAAAAAAkUAAAAAQAAABQAAAAUAAAAFAAAAAEAAAAAAAAAZAAAAGQAAAAAAAAAZAAAAGQAAAAVAAAAYAAAAAAAAAAAAAAADwAAACADAAAAAAAAAAAAAAEAAACgMgAAVgcAAKr4//8BAAAAf39/AAEAAABkAAAAAAAAABQAAABAHwAAAAAAACYAAAAAAAAAwOD//wAAAAAmAAAAZAAAABYAAABMAAAAAAAAAAAAAAAEAAAAAAAAAAEAAABZWVkKAAAAACgAAAAoAAAAZAAAAGQAAAAAAAAAzMzMAAAAAABQAAAAUAAAAGQAAABkAAAAAAAAABcAAAAUAAAAAAAAAAAAAAD/fwAA/38AAAAAAAAJAAAABAAAAM/Y+1ceAAAAaAAAAAAAAAAAAAAAAAAAAAAAAAAAAAAAECcAABAnAAAAAAAAAAAAAAAAAAAAAAAAAAAAAAAAAAAAAAAAAAAAABQAAAAAAAAAwMD/AAAAAABkAAAAMgAAAAAAAABkAAAAAAAAAH9/fwAKAAAAIgAAABgAAAAAAAAAAAAAAAAAAAAAAAAAAAAAAAAAAAAkAAAAJAAAAAAAAAAHAAAAAAAAAAAAAAAAAAAAAAAAAAAAAAAAAAAAf39/ACUAAABYAAAAAAAAAAAAAAAAAAAAAAAAAAAAAAAAAAAAAAAAAAAAAAAAAAAAAAAAAAAAAAA/AAAAAAAAAKCGAQAAAAAAAAAAAAAAAAAMAAAAAQAAAAAAAAAAAAAAAAAAAB8AAABUAAAAAAAABQAAAAEAAAAAAAAAAAAAAAAAAAAAAAAAAAAAAAAAAAAAAAAAAAAAAAJ/f38AAAAAA8zMzADAwP8Af39/AAAAAAAAAAAAAAAAAAAAAAAAAAAAIQAAABgAAAAUAAAAOAQAALgaAAD4JQAACDQAABAAAAAmAAAACAAAAL0/AAAAAAAA"/>
               </a:ext>
             </a:extLst>
           </p:cNvSpPr>
@@ -1312,7 +1312,7 @@
             <a:spLocks noGrp="1" noChangeArrowheads="1"/>
             <a:extLst>
               <a:ext uri="smNativeData">
-                <pr:smNativeData xmlns:pr="smNativeData" xmlns="smNativeData" val="SMDATA_15_9kV5ZhMAAAAlAAAACwAAAA0AAAAACAcAADgEAAAoIwAAUBkAAAAAAAAAAAAAAAAAAAEAAABQAAAAAAAAAAAA4D8AAAAAAADgPwAAAAAAAOA/AAAAAAAA4D8AAAAAAADgPwAAAAAAAOA/AAAAAAAA4D8AAAAAAADgPwAAAAAAAOA/AAAAAAAA4D8CAAAAjAAAAAAAAAAAAAAAQoX0DP///wgAAAAAAAAAAAAAAAAAAAAAAAAAAAAAAAAAAAAAZAAAAAEAAABAAAAAAAAAAAAAAAAAAAAAAAAAAAAAAAAAAAAAAAAAAAAAAAAAAAAAAAAAAAAAAAAAAAAAAAAAAAAAAAAAAAAAAAAAAAAAAAAAAAAAAAAAAAAAAAAAAAAAFAAAADwAAAABAAAAAAAAAAAAAAAPAAAAAQAAACMAAAAjAAAAIwAAAB4AAAAAAAAASwAAAEsAAAAAAAAASwAAAEsAAAAVAAAAYAAAAAAAAAAAAAAADwAAACADAAAAAAAAAAAAAAEAAACgMgAAVgcAAKr4//8BAAAAf39/AAEAAABkAAAAAAAAABQAAABAHwAAAAAAACYAAAAAAAAAwOD//wAAAAAmAAAAZAAAABYAAABMAAAAAAAAAAAAAAAEAAAAAAAAAAEAAABZWVkKAAAAACgAAAAoAAAAZAAAAGQAAAAAAAAAzMzMAAAAAABQAAAAUAAAAGQAAABkAAAAAAAAABcAAAAUAAAAAAAAAAAAAAD/fwAA/38AAAAAAAAJAAAABAAAAEXJ0L8eAAAAaAAAAAAAAAAAAAAAAAAAAAAAAAAAAAAAECcAABAnAAAAAAAAAAAAAAAAAAAAAAAAAAAAAAAAAAAAAAAAAAAAABQAAAAAAAAAwMD/AAAAAABkAAAAMgAAAAAAAABkAAAAAAAAAH9/fwAKAAAAIgAAABgAAAAAAAAAAAAAAAAAAAAAAAAAAAAAAAAAAAAkAAAAJAAAAAAAAAAHAAAAAAAAAAAAAAAAAAAAAAAAAAAAAAAAAAAAf39/ACUAAABYAAAAAAAAAAAAAAAAAAAAAAAAAAAAAAAAAAAAAAAAAAAAAAAAAAAAAAAAAAAAAAA/AAAAAAAAAKCGAQAAAAAAAAAAAAAAAAAMAAAAAQAAAAAAAAAAAAAAAAAAAB8AAABUAAAAAAAABQAAAAEAAAAAAAAAAAAAAAAAAAAAAAAAAAAAAAAAAAAAAAAAAAAAAAB/f38AAAAAA8zMzADAwP8Af39/AAAAAAAAAAAAAAAAAAAAAAAAAAAAIQAAABgAAAAUAAAACAcAADgEAAAoIwAAUBkAABAAAAAmAAAACAAAAAEPAAAAAAAA"/>
+                <pr:smNativeData xmlns:pr="smNativeData" xmlns="smNativeData" val="SMDATA_15_bQt8ZhMAAAAlAAAACwAAAA0AAAAACAcAADgEAAAoIwAAUBkAAAAAAAAAAAAAAAAAAAEAAABQAAAAAAAAAAAA4D8AAAAAAADgPwAAAAAAAOA/AAAAAAAA4D8AAAAAAADgPwAAAAAAAOA/AAAAAAAA4D8AAAAAAADgPwAAAAAAAOA/AAAAAAAA4D8CAAAAjAAAAAAAAAAAAAAAQoX0DP///wgAAAAAAAAAAAAAAAAAAAAAAAAAAAAAAAAAAAAAZAAAAAEAAABAAAAAAAAAAAAAAAAAAAAAAAAAAAAAAAAAAAAAAAAAAAAAAAAAAAAAAAAAAAAAAAAAAAAAAAAAAAAAAAAAAAAAAAAAAAAAAAAAAAAAAAAAAAAAAAAAAAAAFAAAADwAAAABAAAAAAAAAAAAAAAPAAAAAQAAACMAAAAjAAAAIwAAAB4AAAAAAAAASwAAAEsAAAAAAAAASwAAAEsAAAAVAAAAYAAAAAAAAAAAAAAADwAAACADAAAAAAAAAAAAAAEAAACgMgAAVgcAAKr4//8BAAAAf39/AAEAAABkAAAAAAAAABQAAABAHwAAAAAAACYAAAAAAAAAwOD//wAAAAAmAAAAZAAAABYAAABMAAAAAAAAAAAAAAAEAAAAAAAAAAEAAABZWVkKAAAAACgAAAAoAAAAZAAAAGQAAAAAAAAAzMzMAAAAAABQAAAAUAAAAGQAAABkAAAAAAAAABcAAAAUAAAAAAAAAAAAAAD/fwAA/38AAAAAAAAJAAAABAAAAEXJ0L8eAAAAaAAAAAAAAAAAAAAAAAAAAAAAAAAAAAAAECcAABAnAAAAAAAAAAAAAAAAAAAAAAAAAAAAAAAAAAAAAAAAAAAAABQAAAAAAAAAwMD/AAAAAABkAAAAMgAAAAAAAABkAAAAAAAAAH9/fwAKAAAAIgAAABgAAAAAAAAAAAAAAAAAAAAAAAAAAAAAAAAAAAAkAAAAJAAAAAAAAAAHAAAAAAAAAAAAAAAAAAAAAAAAAAAAAAAAAAAAf39/ACUAAABYAAAAAAAAAAAAAAAAAAAAAAAAAAAAAAAAAAAAAAAAAAAAAAAAAAAAAAAAAAAAAAA/AAAAAAAAAKCGAQAAAAAAAAAAAAAAAAAMAAAAAQAAAAAAAAAAAAAAAAAAAB8AAABUAAAAAAAABQAAAAEAAAAAAAAAAAAAAAAAAAAAAAAAAAAAAAAAAAAAAAAAAAAAAAB/f38AAAAAA8zMzADAwP8Af39/AAAAAAAAAAAAAAAAAAAAAAAAAAAAIQAAABgAAAAUAAAACAcAADgEAAAoIwAAUBkAABAAAAAmAAAACAAAAAEPAAAAAAAA"/>
               </a:ext>
             </a:extLst>
           </p:cNvSpPr>
@@ -1358,7 +1358,7 @@
             <a:spLocks noGrp="1" noChangeArrowheads="1"/>
             <a:extLst>
               <a:ext uri="smNativeData">
-                <pr:smNativeData xmlns:pr="smNativeData" xmlns="smNativeData" val="SMDATA_15_9kV5ZhMAAAAlAAAAZAAAAA0AAAAAkAAAAJAAAACQAAAAkAAAAAAAAAAAAAAAAAAAAAEAAABQAAAAAAAAAAAA4D8AAAAAAADgPwAAAAAAAOA/AAAAAAAA4D8AAAAAAADgPwAAAAAAAOA/AAAAAAAA4D8AAAAAAADgPwAAAAAAAOA/AAAAAAAA4D8CAAAAjAAAAAAAAAAAAAAAQoX0DP///wgAAAAAAAAAAAAAAAAAAAAAAAAAAAAAAAAAAAAAZAAAAAEAAABAAAAAAAAAAAAAAAAAAAAAAAAAAAAAAAAAAAAAAAAAAAAAAAAAAAAAAAAAAAAAAAAAAAAAAAAAAAAAAAAAAAAAAAAAAAAAAAAAAAAAAAAAAAAAAAAAAAAAFAAAADwAAAAAAAAAAAAAAAAAAAkUAAAAAQAAABQAAAAUAAAAFAAAAAEAAAAAAAAAZAAAAGQAAAAAAAAAZAAAAGQAAAAVAAAAYAAAAAAAAAAAAAAADwAAACADAAAAAAAAAAAAAAEAAACgMgAAVgcAAKr4//8BAAAAf39/AAEAAABkAAAAAAAAABQAAABAHwAAAAAAACYAAAAAAAAAwOD//wAAAAAmAAAAZAAAABYAAABMAAAAAAAAAAAAAAAEAAAAAAAAAAEAAABZWVkKAAAAACgAAAAoAAAAZAAAAGQAAAAAAAAAzMzMAAAAAABQAAAAUAAAAGQAAABkAAAAAAAAABcAAAAUAAAAAAAAAAAAAAD/fwAA/38AAAAAAAAJAAAABAAAAF8AYAAeAAAAaAAAAAAAAAAAAAAAAAAAAAAAAAAAAAAAECcAABAnAAAAAAAAAAAAAAAAAAAAAAAAAAAAAAAAAAAAAAAAAAAAABQAAAAAAAAAwMD/AAAAAABkAAAAMgAAAAAAAABkAAAAAAAAAH9/fwAKAAAAIgAAABgAAAAAAAAAAAAAAAAAAAAAAAAAAAAAAAAAAAAkAAAAJAAAAAAAAAAHAAAAAAAAAAAAAAAAAAAAAAAAAAAAAAAAAAAAf39/ACUAAABYAAAAAAAAAAAAAAAAAAAAAAAAAAAAAAAAAAAAAAAAAAAAAAAAAAAAAAAAAAAAAAA/AAAAAAAAAKCGAQAAAAAAAAAAAAAAAAAMAAAAAQAAAAAAAAAAAAAAAAAAAB8AAABUAAAAAAAABQAAAAEAAAAAAAAAAAAAAAAAAAAAAAAAAAAAAAAAAAAAAAAAAAAAAAJ/f38AAAAAA8zMzADAwP8Af39/AAAAAAAAAAAAAAAAAAAAAAAAAAAAIQAAABgAAAAUAAAAOAQAALgaAAD4JQAACDQAABAAAAAmAAAACAAAAL0/AAAAAAAA"/>
+                <pr:smNativeData xmlns:pr="smNativeData" xmlns="smNativeData" val="SMDATA_15_bQt8ZhMAAAAlAAAAZAAAAA0AAAAAkAAAAJAAAACQAAAAkAAAAAAAAAAAAAAAAAAAAAEAAABQAAAAAAAAAAAA4D8AAAAAAADgPwAAAAAAAOA/AAAAAAAA4D8AAAAAAADgPwAAAAAAAOA/AAAAAAAA4D8AAAAAAADgPwAAAAAAAOA/AAAAAAAA4D8CAAAAjAAAAAAAAAAAAAAAQoX0DP///wgAAAAAAAAAAAAAAAAAAAAAAAAAAAAAAAAAAAAAZAAAAAEAAABAAAAAAAAAAAAAAAAAAAAAAAAAAAAAAAAAAAAAAAAAAAAAAAAAAAAAAAAAAAAAAAAAAAAAAAAAAAAAAAAAAAAAAAAAAAAAAAAAAAAAAAAAAAAAAAAAAAAAFAAAADwAAAAAAAAAAAAAAAAAAAkUAAAAAQAAABQAAAAUAAAAFAAAAAEAAAAAAAAAZAAAAGQAAAAAAAAAZAAAAGQAAAAVAAAAYAAAAAAAAAAAAAAADwAAACADAAAAAAAAAAAAAAEAAACgMgAAVgcAAKr4//8BAAAAf39/AAEAAABkAAAAAAAAABQAAABAHwAAAAAAACYAAAAAAAAAwOD//wAAAAAmAAAAZAAAABYAAABMAAAAAAAAAAAAAAAEAAAAAAAAAAEAAABZWVkKAAAAACgAAAAoAAAAZAAAAGQAAAAAAAAAzMzMAAAAAABQAAAAUAAAAGQAAABkAAAAAAAAABcAAAAUAAAAAAAAAAAAAAD/fwAA/38AAAAAAAAJAAAABAAAAF8AYAAeAAAAaAAAAAAAAAAAAAAAAAAAAAAAAAAAAAAAECcAABAnAAAAAAAAAAAAAAAAAAAAAAAAAAAAAAAAAAAAAAAAAAAAABQAAAAAAAAAwMD/AAAAAABkAAAAMgAAAAAAAABkAAAAAAAAAH9/fwAKAAAAIgAAABgAAAAAAAAAAAAAAAAAAAAAAAAAAAAAAAAAAAAkAAAAJAAAAAAAAAAHAAAAAAAAAAAAAAAAAAAAAAAAAAAAAAAAAAAAf39/ACUAAABYAAAAAAAAAAAAAAAAAAAAAAAAAAAAAAAAAAAAAAAAAAAAAAAAAAAAAAAAAAAAAAA/AAAAAAAAAKCGAQAAAAAAAAAAAAAAAAAMAAAAAQAAAAAAAAAAAAAAAAAAAB8AAABUAAAAAAAABQAAAAEAAAAAAAAAAAAAAAAAAAAAAAAAAAAAAAAAAAAAAAAAAAAAAAJ/f38AAAAAA8zMzADAwP8Af39/AAAAAAAAAAAAAAAAAAAAAAAAAAAAIQAAABgAAAAUAAAAOAQAALgaAAD4JQAACDQAABAAAAAmAAAACAAAAL0/AAAAAAAA"/>
               </a:ext>
             </a:extLst>
           </p:cNvSpPr>
@@ -1435,7 +1435,7 @@
             <a:spLocks noGrp="1" noChangeArrowheads="1"/>
             <a:extLst>
               <a:ext uri="smNativeData">
-                <pr:smNativeData xmlns:pr="smNativeData" xmlns="smNativeData" val="SMDATA_15_9kV5ZhMAAAAlAAAACwAAAA0AAAAACAcAADgEAAAoIwAAUBkAAAAAAAAAAAAAAAAAAAEAAABQAAAAAAAAAAAA4D8AAAAAAADgPwAAAAAAAOA/AAAAAAAA4D8AAAAAAADgPwAAAAAAAOA/AAAAAAAA4D8AAAAAAADgPwAAAAAAAOA/AAAAAAAA4D8CAAAAjAAAAAAAAAAAAAAAQoX0DP///wgAAAAAAAAAAAAAAAAAAAAAAAAAAAAAAAAAAAAAZAAAAAEAAABAAAAAAAAAAAAAAAAAAAAAAAAAAAAAAAAAAAAAAAAAAAAAAAAAAAAAAAAAAAAAAAAAAAAAAAAAAAAAAAAAAAAAAAAAAAAAAAAAAAAAAAAAAAAAAAAAAAAAFAAAADwAAAABAAAAAAAAAAAAAAAPAAAAAQAAACMAAAAjAAAAIwAAAB4AAAAAAAAASwAAAEsAAAAAAAAASwAAAEsAAAAVAAAAYAAAAAAAAAAAAAAADwAAACADAAAAAAAAAAAAAAEAAACgMgAAVgcAAKr4//8BAAAAf39/AAEAAABkAAAAAAAAABQAAABAHwAAAAAAACYAAAAAAAAAwOD//wAAAAAmAAAAZAAAABYAAABMAAAAAAAAAAAAAAAEAAAAAAAAAAEAAABZWVkKAAAAACgAAAAoAAAAZAAAAGQAAAAAAAAAzMzMAAAAAABQAAAAUAAAAGQAAABkAAAAAAAAABcAAAAUAAAAAAAAAAAAAAD/fwAA/38AAAAAAAAJAAAABAAAAAAAAAAeAAAAaAAAAAAAAAAAAAAAAAAAAAAAAAAAAAAAECcAABAnAAAAAAAAAAAAAAAAAAAAAAAAAAAAAAAAAAAAAAAAAAAAABQAAAAAAAAAwMD/AAAAAABkAAAAMgAAAAAAAABkAAAAAAAAAH9/fwAKAAAAIgAAABgAAAAAAAAAAAAAAAAAAAAAAAAAAAAAAAAAAAAkAAAAJAAAAAAAAAAHAAAAAAAAAAAAAAAAAAAAAAAAAAAAAAAAAAAAf39/ACUAAABYAAAAAAAAAAAAAAAAAAAAAAAAAAAAAAAAAAAAAAAAAAAAAAAAAAAAAAAAAAAAAAA/AAAAAAAAAKCGAQAAAAAAAAAAAAAAAAAMAAAAAQAAAAAAAAAAAAAAAAAAAB8AAABUAAAAAAAABQAAAAEAAAAAAAAAAAAAAAAAAAAAAAAAAAAAAAAAAAAAAAAAAAAAAAB/f38AAAAAA8zMzADAwP8Af39/AAAAAAAAAAAAAAAAAAAAAAAAAAAAIQAAABgAAAAUAAAACAcAADgEAAAoIwAAUBkAABAAAAAmAAAACAAAAAEPAAAAAAAA"/>
+                <pr:smNativeData xmlns:pr="smNativeData" xmlns="smNativeData" val="SMDATA_15_bQt8ZhMAAAAlAAAACwAAAA0AAAAACAcAADgEAAAoIwAAUBkAAAAAAAAAAAAAAAAAAAEAAABQAAAAAAAAAAAA4D8AAAAAAADgPwAAAAAAAOA/AAAAAAAA4D8AAAAAAADgPwAAAAAAAOA/AAAAAAAA4D8AAAAAAADgPwAAAAAAAOA/AAAAAAAA4D8CAAAAjAAAAAAAAAAAAAAAQoX0DP///wgAAAAAAAAAAAAAAAAAAAAAAAAAAAAAAAAAAAAAZAAAAAEAAABAAAAAAAAAAAAAAAAAAAAAAAAAAAAAAAAAAAAAAAAAAAAAAAAAAAAAAAAAAAAAAAAAAAAAAAAAAAAAAAAAAAAAAAAAAAAAAAAAAAAAAAAAAAAAAAAAAAAAFAAAADwAAAABAAAAAAAAAAAAAAAPAAAAAQAAACMAAAAjAAAAIwAAAB4AAAAAAAAASwAAAEsAAAAAAAAASwAAAEsAAAAVAAAAYAAAAAAAAAAAAAAADwAAACADAAAAAAAAAAAAAAEAAACgMgAAVgcAAKr4//8BAAAAf39/AAEAAABkAAAAAAAAABQAAABAHwAAAAAAACYAAAAAAAAAwOD//wAAAAAmAAAAZAAAABYAAABMAAAAAAAAAAAAAAAEAAAAAAAAAAEAAABZWVkKAAAAACgAAAAoAAAAZAAAAGQAAAAAAAAAzMzMAAAAAABQAAAAUAAAAGQAAABkAAAAAAAAABcAAAAUAAAAAAAAAAAAAAD/fwAA/38AAAAAAAAJAAAABAAAAAAAAAAeAAAAaAAAAAAAAAAAAAAAAAAAAAAAAAAAAAAAECcAABAnAAAAAAAAAAAAAAAAAAAAAAAAAAAAAAAAAAAAAAAAAAAAABQAAAAAAAAAwMD/AAAAAABkAAAAMgAAAAAAAABkAAAAAAAAAH9/fwAKAAAAIgAAABgAAAAAAAAAAAAAAAAAAAAAAAAAAAAAAAAAAAAkAAAAJAAAAAAAAAAHAAAAAAAAAAAAAAAAAAAAAAAAAAAAAAAAAAAAf39/ACUAAABYAAAAAAAAAAAAAAAAAAAAAAAAAAAAAAAAAAAAAAAAAAAAAAAAAAAAAAAAAAAAAAA/AAAAAAAAAKCGAQAAAAAAAAAAAAAAAAAMAAAAAQAAAAAAAAAAAAAAAAAAAB8AAABUAAAAAAAABQAAAAEAAAAAAAAAAAAAAAAAAAAAAAAAAAAAAAAAAAAAAAAAAAAAAAB/f38AAAAAA8zMzADAwP8Af39/AAAAAAAAAAAAAAAAAAAAAAAAAAAAIQAAABgAAAAUAAAACAcAADgEAAAoIwAAUBkAABAAAAAmAAAACAAAAAEPAAAAAAAA"/>
               </a:ext>
             </a:extLst>
           </p:cNvSpPr>
@@ -1481,7 +1481,7 @@
             <a:spLocks noGrp="1" noChangeArrowheads="1"/>
             <a:extLst>
               <a:ext uri="smNativeData">
-                <pr:smNativeData xmlns:pr="smNativeData" xmlns="smNativeData" val="SMDATA_15_9kV5ZhMAAAAlAAAAZAAAAA0AAAAAkAAAAJAAAACQAAAAkAAAAAAAAAAAAAAAAAAAAAEAAABQAAAAAAAAAAAA4D8AAAAAAADgPwAAAAAAAOA/AAAAAAAA4D8AAAAAAADgPwAAAAAAAOA/AAAAAAAA4D8AAAAAAADgPwAAAAAAAOA/AAAAAAAA4D8CAAAAjAAAAAAAAAAAAAAAQoX0DP///wgAAAAAAAAAAAAAAAAAAAAAAAAAAAAAAAAAAAAAZAAAAAEAAABAAAAAAAAAAAAAAAAAAAAAAAAAAAAAAAAAAAAAAAAAAAAAAAAAAAAAAAAAAAAAAAAAAAAAAAAAAAAAAAAAAAAAAAAAAAAAAAAAAAAAAAAAAAAAAAAAAAAAFAAAADwAAAAAAAAAAAAAAAAAAAkUAAAAAQAAABQAAAAUAAAAFAAAAAEAAAAAAAAAZAAAAGQAAAAAAAAAZAAAAGQAAAAVAAAAYAAAAAAAAAAAAAAADwAAACADAAAAAAAAAAAAAAEAAACgMgAAVgcAAKr4//8BAAAAf39/AAEAAABkAAAAAAAAABQAAABAHwAAAAAAACYAAAAAAAAAwOD//wAAAAAmAAAAZAAAABYAAABMAAAAAAAAAAAAAAAEAAAAAAAAAAEAAABZWVkKAAAAACgAAAAoAAAAZAAAAGQAAAAAAAAAzMzMAAAAAABQAAAAUAAAAGQAAABkAAAAAAAAABcAAAAUAAAAAAAAAAAAAAD/fwAA/38AAAAAAAAJAAAABAAAADFRIqYeAAAAaAAAAAAAAAAAAAAAAAAAAAAAAAAAAAAAECcAABAnAAAAAAAAAAAAAAAAAAAAAAAAAAAAAAAAAAAAAAAAAAAAABQAAAAAAAAAwMD/AAAAAABkAAAAMgAAAAAAAABkAAAAAAAAAH9/fwAKAAAAIgAAABgAAAAAAAAAAAAAAAAAAAAAAAAAAAAAAAAAAAAkAAAAJAAAAAAAAAAHAAAAAAAAAAAAAAAAAAAAAAAAAAAAAAAAAAAAf39/ACUAAABYAAAAAAAAAAAAAAAAAAAAAAAAAAAAAAAAAAAAAAAAAAAAAAAAAAAAAAAAAAAAAAA/AAAAAAAAAKCGAQAAAAAAAAAAAAAAAAAMAAAAAQAAAAAAAAAAAAAAAAAAAB8AAABUAAAAAAAABQAAAAEAAAAAAAAAAAAAAAAAAAAAAAAAAAAAAAAAAAAAAAAAAAAAAAJ/f38AAAAAA8zMzADAwP8Af39/AAAAAAAAAAAAAAAAAAAAAAAAAAAAIQAAABgAAAAUAAAAOAQAALgaAAD4JQAACDQAABAAAAAmAAAACAAAAL0/AAAAAAAA"/>
+                <pr:smNativeData xmlns:pr="smNativeData" xmlns="smNativeData" val="SMDATA_15_bQt8ZhMAAAAlAAAAZAAAAA0AAAAAkAAAAJAAAACQAAAAkAAAAAAAAAAAAAAAAAAAAAEAAABQAAAAAAAAAAAA4D8AAAAAAADgPwAAAAAAAOA/AAAAAAAA4D8AAAAAAADgPwAAAAAAAOA/AAAAAAAA4D8AAAAAAADgPwAAAAAAAOA/AAAAAAAA4D8CAAAAjAAAAAAAAAAAAAAAQoX0DP///wgAAAAAAAAAAAAAAAAAAAAAAAAAAAAAAAAAAAAAZAAAAAEAAABAAAAAAAAAAAAAAAAAAAAAAAAAAAAAAAAAAAAAAAAAAAAAAAAAAAAAAAAAAAAAAAAAAAAAAAAAAAAAAAAAAAAAAAAAAAAAAAAAAAAAAAAAAAAAAAAAAAAAFAAAADwAAAAAAAAAAAAAAAAAAAkUAAAAAQAAABQAAAAUAAAAFAAAAAEAAAAAAAAAZAAAAGQAAAAAAAAAZAAAAGQAAAAVAAAAYAAAAAAAAAAAAAAADwAAACADAAAAAAAAAAAAAAEAAACgMgAAVgcAAKr4//8BAAAAf39/AAEAAABkAAAAAAAAABQAAABAHwAAAAAAACYAAAAAAAAAwOD//wAAAAAmAAAAZAAAABYAAABMAAAAAAAAAAAAAAAEAAAAAAAAAAEAAABZWVkKAAAAACgAAAAoAAAAZAAAAGQAAAAAAAAAzMzMAAAAAABQAAAAUAAAAGQAAABkAAAAAAAAABcAAAAUAAAAAAAAAAAAAAD/fwAA/38AAAAAAAAJAAAABAAAADFRIqYeAAAAaAAAAAAAAAAAAAAAAAAAAAAAAAAAAAAAECcAABAnAAAAAAAAAAAAAAAAAAAAAAAAAAAAAAAAAAAAAAAAAAAAABQAAAAAAAAAwMD/AAAAAABkAAAAMgAAAAAAAABkAAAAAAAAAH9/fwAKAAAAIgAAABgAAAAAAAAAAAAAAAAAAAAAAAAAAAAAAAAAAAAkAAAAJAAAAAAAAAAHAAAAAAAAAAAAAAAAAAAAAAAAAAAAAAAAAAAAf39/ACUAAABYAAAAAAAAAAAAAAAAAAAAAAAAAAAAAAAAAAAAAAAAAAAAAAAAAAAAAAAAAAAAAAA/AAAAAAAAAKCGAQAAAAAAAAAAAAAAAAAMAAAAAQAAAAAAAAAAAAAAAAAAAB8AAABUAAAAAAAABQAAAAEAAAAAAAAAAAAAAAAAAAAAAAAAAAAAAAAAAAAAAAAAAAAAAAJ/f38AAAAAA8zMzADAwP8Af39/AAAAAAAAAAAAAAAAAAAAAAAAAAAAIQAAABgAAAAUAAAAOAQAALgaAAD4JQAACDQAABAAAAAmAAAACAAAAL0/AAAAAAAA"/>
               </a:ext>
             </a:extLst>
           </p:cNvSpPr>
@@ -1558,7 +1558,7 @@
             <a:spLocks noGrp="1" noChangeArrowheads="1"/>
             <a:extLst>
               <a:ext uri="smNativeData">
-                <pr:smNativeData xmlns:pr="smNativeData" xmlns="smNativeData" val="SMDATA_15_9kV5ZhMAAAAlAAAACwAAAA0AAAAACAcAADgEAAAoIwAAUBkAAAAAAAAAAAAAAAAAAAEAAABQAAAAAAAAAAAA4D8AAAAAAADgPwAAAAAAAOA/AAAAAAAA4D8AAAAAAADgPwAAAAAAAOA/AAAAAAAA4D8AAAAAAADgPwAAAAAAAOA/AAAAAAAA4D8CAAAAjAAAAAAAAAAAAAAAQoX0DP///wgAAAAAAAAAAAAAAAAAAAAAAAAAAAAAAAAAAAAAZAAAAAEAAABAAAAAAAAAAAAAAAAAAAAAAAAAAAAAAAAAAAAAAAAAAAAAAAAAAAAAAAAAAAAAAAAAAAAAAAAAAAAAAAAAAAAAAAAAAAAAAAAAAAAAAAAAAAAAAAAAAAAAFAAAADwAAAABAAAAAAAAAAAAAAAPAAAAAQAAACMAAAAjAAAAIwAAAB4AAAAAAAAASwAAAEsAAAAAAAAASwAAAEsAAAAVAAAAYAAAAAAAAAAAAAAADwAAACADAAAAAAAAAAAAAAEAAACgMgAAVgcAAKr4//8BAAAAf39/AAEAAABkAAAAAAAAABQAAABAHwAAAAAAACYAAAAAAAAAwOD//wAAAAAmAAAAZAAAABYAAABMAAAAAAAAAAAAAAAEAAAAAAAAAAEAAABZWVkKAAAAACgAAAAoAAAAZAAAAGQAAAAAAAAAzMzMAAAAAABQAAAAUAAAAGQAAABkAAAAAAAAABcAAAAUAAAAAAAAAAAAAAD/fwAA/38AAAAAAAAJAAAABAAAAAAAAAAeAAAAaAAAAAAAAAAAAAAAAAAAAAAAAAAAAAAAECcAABAnAAAAAAAAAAAAAAAAAAAAAAAAAAAAAAAAAAAAAAAAAAAAABQAAAAAAAAAwMD/AAAAAABkAAAAMgAAAAAAAABkAAAAAAAAAH9/fwAKAAAAIgAAABgAAAAAAAAAAAAAAAAAAAAAAAAAAAAAAAAAAAAkAAAAJAAAAAAAAAAHAAAAAAAAAAAAAAAAAAAAAAAAAAAAAAAAAAAAf39/ACUAAABYAAAAAAAAAAAAAAAAAAAAAAAAAAAAAAAAAAAAAAAAAAAAAAAAAAAAAAAAAAAAAAA/AAAAAAAAAKCGAQAAAAAAAAAAAAAAAAAMAAAAAQAAAAAAAAAAAAAAAAAAAB8AAABUAAAAAAAABQAAAAEAAAAAAAAAAAAAAAAAAAAAAAAAAAAAAAAAAAAAAAAAAAAAAAB/f38AAAAAA8zMzADAwP8Af39/AAAAAAAAAAAAAAAAAAAAAAAAAAAAIQAAABgAAAAUAAAACAcAADgEAAAoIwAAUBkAABAAAAAmAAAACAAAAAEPAAAAAAAA"/>
+                <pr:smNativeData xmlns:pr="smNativeData" xmlns="smNativeData" val="SMDATA_15_bQt8ZhMAAAAlAAAACwAAAA0AAAAACAcAADgEAAAoIwAAUBkAAAAAAAAAAAAAAAAAAAEAAABQAAAAAAAAAAAA4D8AAAAAAADgPwAAAAAAAOA/AAAAAAAA4D8AAAAAAADgPwAAAAAAAOA/AAAAAAAA4D8AAAAAAADgPwAAAAAAAOA/AAAAAAAA4D8CAAAAjAAAAAAAAAAAAAAAQoX0DP///wgAAAAAAAAAAAAAAAAAAAAAAAAAAAAAAAAAAAAAZAAAAAEAAABAAAAAAAAAAAAAAAAAAAAAAAAAAAAAAAAAAAAAAAAAAAAAAAAAAAAAAAAAAAAAAAAAAAAAAAAAAAAAAAAAAAAAAAAAAAAAAAAAAAAAAAAAAAAAAAAAAAAAFAAAADwAAAABAAAAAAAAAAAAAAAPAAAAAQAAACMAAAAjAAAAIwAAAB4AAAAAAAAASwAAAEsAAAAAAAAASwAAAEsAAAAVAAAAYAAAAAAAAAAAAAAADwAAACADAAAAAAAAAAAAAAEAAACgMgAAVgcAAKr4//8BAAAAf39/AAEAAABkAAAAAAAAABQAAABAHwAAAAAAACYAAAAAAAAAwOD//wAAAAAmAAAAZAAAABYAAABMAAAAAAAAAAAAAAAEAAAAAAAAAAEAAABZWVkKAAAAACgAAAAoAAAAZAAAAGQAAAAAAAAAzMzMAAAAAABQAAAAUAAAAGQAAABkAAAAAAAAABcAAAAUAAAAAAAAAAAAAAD/fwAA/38AAAAAAAAJAAAABAAAAAAAAAAeAAAAaAAAAAAAAAAAAAAAAAAAAAAAAAAAAAAAECcAABAnAAAAAAAAAAAAAAAAAAAAAAAAAAAAAAAAAAAAAAAAAAAAABQAAAAAAAAAwMD/AAAAAABkAAAAMgAAAAAAAABkAAAAAAAAAH9/fwAKAAAAIgAAABgAAAAAAAAAAAAAAAAAAAAAAAAAAAAAAAAAAAAkAAAAJAAAAAAAAAAHAAAAAAAAAAAAAAAAAAAAAAAAAAAAAAAAAAAAf39/ACUAAABYAAAAAAAAAAAAAAAAAAAAAAAAAAAAAAAAAAAAAAAAAAAAAAAAAAAAAAAAAAAAAAA/AAAAAAAAAKCGAQAAAAAAAAAAAAAAAAAMAAAAAQAAAAAAAAAAAAAAAAAAAB8AAABUAAAAAAAABQAAAAEAAAAAAAAAAAAAAAAAAAAAAAAAAAAAAAAAAAAAAAAAAAAAAAB/f38AAAAAA8zMzADAwP8Af39/AAAAAAAAAAAAAAAAAAAAAAAAAAAAIQAAABgAAAAUAAAACAcAADgEAAAoIwAAUBkAABAAAAAmAAAACAAAAAEPAAAAAAAA"/>
               </a:ext>
             </a:extLst>
           </p:cNvSpPr>
@@ -1604,7 +1604,7 @@
             <a:spLocks noGrp="1" noChangeArrowheads="1"/>
             <a:extLst>
               <a:ext uri="smNativeData">
-                <pr:smNativeData xmlns:pr="smNativeData" xmlns="smNativeData" val="SMDATA_15_9kV5ZhMAAAAlAAAAZAAAAA0AAAAAkAAAAJAAAACQAAAAkAAAAAAAAAAAAAAAAAAAAAEAAABQAAAAAAAAAAAA4D8AAAAAAADgPwAAAAAAAOA/AAAAAAAA4D8AAAAAAADgPwAAAAAAAOA/AAAAAAAA4D8AAAAAAADgPwAAAAAAAOA/AAAAAAAA4D8CAAAAjAAAAAAAAAAAAAAAQoX0DP///wgAAAAAAAAAAAAAAAAAAAAAAAAAAAAAAAAAAAAAZAAAAAEAAABAAAAAAAAAAAAAAAAAAAAAAAAAAAAAAAAAAAAAAAAAAAAAAAAAAAAAAAAAAAAAAAAAAAAAAAAAAAAAAAAAAAAAAAAAAAAAAAAAAAAAAAAAAAAAAAAAAAAAFAAAADwAAAAAAAAAAAAAAAAAAAkUAAAAAQAAABQAAAAUAAAAFAAAAAEAAAAAAAAAZAAAAGQAAAAAAAAAZAAAAGQAAAAVAAAAYAAAAAAAAAAAAAAADwAAACADAAAAAAAAAAAAAAEAAACgMgAAVgcAAKr4//8BAAAAf39/AAEAAABkAAAAAAAAABQAAABAHwAAAAAAACYAAAAAAAAAwOD//wAAAAAmAAAAZAAAABYAAABMAAAAAAAAAAAAAAAEAAAAAAAAAAEAAABZWVkKAAAAACgAAAAoAAAAZAAAAGQAAAAAAAAAzMzMAAAAAABQAAAAUAAAAGQAAABkAAAAAAAAABcAAAAUAAAAAAAAAAAAAAD/fwAA/38AAAAAAAAJAAAABAAAAKMkqfweAAAAaAAAAAAAAAAAAAAAAAAAAAAAAAAAAAAAECcAABAnAAAAAAAAAAAAAAAAAAAAAAAAAAAAAAAAAAAAAAAAAAAAABQAAAAAAAAAwMD/AAAAAABkAAAAMgAAAAAAAABkAAAAAAAAAH9/fwAKAAAAIgAAABgAAAAAAAAAAAAAAAAAAAAAAAAAAAAAAAAAAAAkAAAAJAAAAAAAAAAHAAAAAAAAAAAAAAAAAAAAAAAAAAAAAAAAAAAAf39/ACUAAABYAAAAAAAAAAAAAAAAAAAAAAAAAAAAAAAAAAAAAAAAAAAAAAAAAAAAAAAAAAAAAAA/AAAAAAAAAKCGAQAAAAAAAAAAAAAAAAAMAAAAAQAAAAAAAAAAAAAAAAAAAB8AAABUAAAAAAAABQAAAAEAAAAAAAAAAAAAAAAAAAAAAAAAAAAAAAAAAAAAAAAAAAAAAAJ/f38AAAAAA8zMzADAwP8Af39/AAAAAAAAAAAAAAAAAAAAAAAAAAAAIQAAABgAAAAUAAAAOAQAALgaAAD4JQAACDQAABAAAAAmAAAACAAAAL0/AAAAAAAA"/>
+                <pr:smNativeData xmlns:pr="smNativeData" xmlns="smNativeData" val="SMDATA_15_bQt8ZhMAAAAlAAAAZAAAAA0AAAAAkAAAAJAAAACQAAAAkAAAAAAAAAAAAAAAAAAAAAEAAABQAAAAAAAAAAAA4D8AAAAAAADgPwAAAAAAAOA/AAAAAAAA4D8AAAAAAADgPwAAAAAAAOA/AAAAAAAA4D8AAAAAAADgPwAAAAAAAOA/AAAAAAAA4D8CAAAAjAAAAAAAAAAAAAAAQoX0DP///wgAAAAAAAAAAAAAAAAAAAAAAAAAAAAAAAAAAAAAZAAAAAEAAABAAAAAAAAAAAAAAAAAAAAAAAAAAAAAAAAAAAAAAAAAAAAAAAAAAAAAAAAAAAAAAAAAAAAAAAAAAAAAAAAAAAAAAAAAAAAAAAAAAAAAAAAAAAAAAAAAAAAAFAAAADwAAAAAAAAAAAAAAAAAAAkUAAAAAQAAABQAAAAUAAAAFAAAAAEAAAAAAAAAZAAAAGQAAAAAAAAAZAAAAGQAAAAVAAAAYAAAAAAAAAAAAAAADwAAACADAAAAAAAAAAAAAAEAAACgMgAAVgcAAKr4//8BAAAAf39/AAEAAABkAAAAAAAAABQAAABAHwAAAAAAACYAAAAAAAAAwOD//wAAAAAmAAAAZAAAABYAAABMAAAAAAAAAAAAAAAEAAAAAAAAAAEAAABZWVkKAAAAACgAAAAoAAAAZAAAAGQAAAAAAAAAzMzMAAAAAABQAAAAUAAAAGQAAABkAAAAAAAAABcAAAAUAAAAAAAAAAAAAAD/fwAA/38AAAAAAAAJAAAABAAAAKMkqfweAAAAaAAAAAAAAAAAAAAAAAAAAAAAAAAAAAAAECcAABAnAAAAAAAAAAAAAAAAAAAAAAAAAAAAAAAAAAAAAAAAAAAAABQAAAAAAAAAwMD/AAAAAABkAAAAMgAAAAAAAABkAAAAAAAAAH9/fwAKAAAAIgAAABgAAAAAAAAAAAAAAAAAAAAAAAAAAAAAAAAAAAAkAAAAJAAAAAAAAAAHAAAAAAAAAAAAAAAAAAAAAAAAAAAAAAAAAAAAf39/ACUAAABYAAAAAAAAAAAAAAAAAAAAAAAAAAAAAAAAAAAAAAAAAAAAAAAAAAAAAAAAAAAAAAA/AAAAAAAAAKCGAQAAAAAAAAAAAAAAAAAMAAAAAQAAAAAAAAAAAAAAAAAAAB8AAABUAAAAAAAABQAAAAEAAAAAAAAAAAAAAAAAAAAAAAAAAAAAAAAAAAAAAAAAAAAAAAJ/f38AAAAAA8zMzADAwP8Af39/AAAAAAAAAAAAAAAAAAAAAAAAAAAAIQAAABgAAAAUAAAAOAQAALgaAAD4JQAACDQAABAAAAAmAAAACAAAAL0/AAAAAAAA"/>
               </a:ext>
             </a:extLst>
           </p:cNvSpPr>
@@ -1681,7 +1681,7 @@
             <a:spLocks noGrp="1" noChangeArrowheads="1"/>
             <a:extLst>
               <a:ext uri="smNativeData">
-                <pr:smNativeData xmlns:pr="smNativeData" xmlns="smNativeData" val="SMDATA_15_9kV5ZhMAAAAlAAAACwAAAA0AAAAACAcAADgEAAAoIwAAUBkAAAAAAAAAAAAAAAAAAAEAAABQAAAAAAAAAAAA4D8AAAAAAADgPwAAAAAAAOA/AAAAAAAA4D8AAAAAAADgPwAAAAAAAOA/AAAAAAAA4D8AAAAAAADgPwAAAAAAAOA/AAAAAAAA4D8CAAAAjAAAAAAAAAAAAAAAQoX0DP///wgAAAAAAAAAAAAAAAAAAAAAAAAAAAAAAAAAAAAAZAAAAAEAAABAAAAAAAAAAAAAAAAAAAAAAAAAAAAAAAAAAAAAAAAAAAAAAAAAAAAAAAAAAAAAAAAAAAAAAAAAAAAAAAAAAAAAAAAAAAAAAAAAAAAAAAAAAAAAAAAAAAAAFAAAADwAAAABAAAAAAAAAAAAAAAPAAAAAQAAACMAAAAjAAAAIwAAAB4AAAAAAAAASwAAAEsAAAAAAAAASwAAAEsAAAAVAAAAYAAAAAAAAAAAAAAADwAAACADAAAAAAAAAAAAAAEAAACgMgAAVgcAAKr4//8BAAAAf39/AAEAAABkAAAAAAAAABQAAABAHwAAAAAAACYAAAAAAAAAwOD//wAAAAAmAAAAZAAAABYAAABMAAAAAAAAAAAAAAAEAAAAAAAAAAEAAABZWVkKAAAAACgAAAAoAAAAZAAAAGQAAAAAAAAAzMzMAAAAAABQAAAAUAAAAGQAAABkAAAAAAAAABcAAAAUAAAAAAAAAAAAAAD/fwAA/38AAAAAAAAJAAAABAAAAAAAAAAeAAAAaAAAAAAAAAAAAAAAAAAAAAAAAAAAAAAAECcAABAnAAAAAAAAAAAAAAAAAAAAAAAAAAAAAAAAAAAAAAAAAAAAABQAAAAAAAAAwMD/AAAAAABkAAAAMgAAAAAAAABkAAAAAAAAAH9/fwAKAAAAIgAAABgAAAAAAAAAAAAAAAAAAAAAAAAAAAAAAAAAAAAkAAAAJAAAAAAAAAAHAAAAAAAAAAAAAAAAAAAAAAAAAAAAAAAAAAAAf39/ACUAAABYAAAAAAAAAAAAAAAAAAAAAAAAAAAAAAAAAAAAAAAAAAAAAAAAAAAAAAAAAAAAAAA/AAAAAAAAAKCGAQAAAAAAAAAAAAAAAAAMAAAAAQAAAAAAAAAAAAAAAAAAAB8AAABUAAAAAAAABQAAAAEAAAAAAAAAAAAAAAAAAAAAAAAAAAAAAAAAAAAAAAAAAAAAAAB/f38AAAAAA8zMzADAwP8Af39/AAAAAAAAAAAAAAAAAAAAAAAAAAAAIQAAABgAAAAUAAAACAcAADgEAAAoIwAAUBkAABAAAAAmAAAACAAAAAEPAAAAAAAA"/>
+                <pr:smNativeData xmlns:pr="smNativeData" xmlns="smNativeData" val="SMDATA_15_bQt8ZhMAAAAlAAAACwAAAA0AAAAACAcAADgEAAAoIwAAUBkAAAAAAAAAAAAAAAAAAAEAAABQAAAAAAAAAAAA4D8AAAAAAADgPwAAAAAAAOA/AAAAAAAA4D8AAAAAAADgPwAAAAAAAOA/AAAAAAAA4D8AAAAAAADgPwAAAAAAAOA/AAAAAAAA4D8CAAAAjAAAAAAAAAAAAAAAQoX0DP///wgAAAAAAAAAAAAAAAAAAAAAAAAAAAAAAAAAAAAAZAAAAAEAAABAAAAAAAAAAAAAAAAAAAAAAAAAAAAAAAAAAAAAAAAAAAAAAAAAAAAAAAAAAAAAAAAAAAAAAAAAAAAAAAAAAAAAAAAAAAAAAAAAAAAAAAAAAAAAAAAAAAAAFAAAADwAAAABAAAAAAAAAAAAAAAPAAAAAQAAACMAAAAjAAAAIwAAAB4AAAAAAAAASwAAAEsAAAAAAAAASwAAAEsAAAAVAAAAYAAAAAAAAAAAAAAADwAAACADAAAAAAAAAAAAAAEAAACgMgAAVgcAAKr4//8BAAAAf39/AAEAAABkAAAAAAAAABQAAABAHwAAAAAAACYAAAAAAAAAwOD//wAAAAAmAAAAZAAAABYAAABMAAAAAAAAAAAAAAAEAAAAAAAAAAEAAABZWVkKAAAAACgAAAAoAAAAZAAAAGQAAAAAAAAAzMzMAAAAAABQAAAAUAAAAGQAAABkAAAAAAAAABcAAAAUAAAAAAAAAAAAAAD/fwAA/38AAAAAAAAJAAAABAAAAAAAAAAeAAAAaAAAAAAAAAAAAAAAAAAAAAAAAAAAAAAAECcAABAnAAAAAAAAAAAAAAAAAAAAAAAAAAAAAAAAAAAAAAAAAAAAABQAAAAAAAAAwMD/AAAAAABkAAAAMgAAAAAAAABkAAAAAAAAAH9/fwAKAAAAIgAAABgAAAAAAAAAAAAAAAAAAAAAAAAAAAAAAAAAAAAkAAAAJAAAAAAAAAAHAAAAAAAAAAAAAAAAAAAAAAAAAAAAAAAAAAAAf39/ACUAAABYAAAAAAAAAAAAAAAAAAAAAAAAAAAAAAAAAAAAAAAAAAAAAAAAAAAAAAAAAAAAAAA/AAAAAAAAAKCGAQAAAAAAAAAAAAAAAAAMAAAAAQAAAAAAAAAAAAAAAAAAAB8AAABUAAAAAAAABQAAAAEAAAAAAAAAAAAAAAAAAAAAAAAAAAAAAAAAAAAAAAAAAAAAAAB/f38AAAAAA8zMzADAwP8Af39/AAAAAAAAAAAAAAAAAAAAAAAAAAAAIQAAABgAAAAUAAAACAcAADgEAAAoIwAAUBkAABAAAAAmAAAACAAAAAEPAAAAAAAA"/>
               </a:ext>
             </a:extLst>
           </p:cNvSpPr>
@@ -1727,7 +1727,7 @@
             <a:spLocks noGrp="1" noChangeArrowheads="1"/>
             <a:extLst>
               <a:ext uri="smNativeData">
-                <pr:smNativeData xmlns:pr="smNativeData" xmlns="smNativeData" val="SMDATA_15_9kV5ZhMAAAAlAAAAZAAAAA0AAAAAkAAAAJAAAACQAAAAkAAAAAAAAAAAAAAAAAAAAAEAAABQAAAAAAAAAAAA4D8AAAAAAADgPwAAAAAAAOA/AAAAAAAA4D8AAAAAAADgPwAAAAAAAOA/AAAAAAAA4D8AAAAAAADgPwAAAAAAAOA/AAAAAAAA4D8CAAAAjAAAAAAAAAAAAAAAQoX0DP///wgAAAAAAAAAAAAAAAAAAAAAAAAAAAAAAAAAAAAAZAAAAAEAAABAAAAAAAAAAAAAAAAAAAAAAAAAAAAAAAAAAAAAAAAAAAAAAAAAAAAAAAAAAAAAAAAAAAAAAAAAAAAAAAAAAAAAAAAAAAAAAAAAAAAAAAAAAAAAAAAAAAAAFAAAADwAAAAAAAAAAAAAAAAAAAkUAAAAAQAAABQAAAAUAAAAFAAAAAEAAAAAAAAAZAAAAGQAAAAAAAAAZAAAAGQAAAAVAAAAYAAAAAAAAAAAAAAADwAAACADAAAAAAAAAAAAAAEAAACgMgAAVgcAAKr4//8BAAAAf39/AAEAAABkAAAAAAAAABQAAABAHwAAAAAAACYAAAAAAAAAwOD//wAAAAAmAAAAZAAAABYAAABMAAAAAAAAAAAAAAAEAAAAAAAAAAEAAABZWVkKAAAAACgAAAAoAAAAZAAAAGQAAAAAAAAAzMzMAAAAAABQAAAAUAAAAGQAAABkAAAAAAAAABcAAAAUAAAAAAAAAAAAAAD/fwAA/38AAAAAAAAJAAAABAAAAF8AYAAeAAAAaAAAAAAAAAAAAAAAAAAAAAAAAAAAAAAAECcAABAnAAAAAAAAAAAAAAAAAAAAAAAAAAAAAAAAAAAAAAAAAAAAABQAAAAAAAAAwMD/AAAAAABkAAAAMgAAAAAAAABkAAAAAAAAAH9/fwAKAAAAIgAAABgAAAAAAAAAAAAAAAAAAAAAAAAAAAAAAAAAAAAkAAAAJAAAAAAAAAAHAAAAAAAAAAAAAAAAAAAAAAAAAAAAAAAAAAAAf39/ACUAAABYAAAAAAAAAAAAAAAAAAAAAAAAAAAAAAAAAAAAAAAAAAAAAAAAAAAAAAAAAAAAAAA/AAAAAAAAAKCGAQAAAAAAAAAAAAAAAAAMAAAAAQAAAAAAAAAAAAAAAAAAAB8AAABUAAAAAAAABQAAAAEAAAAAAAAAAAAAAAAAAAAAAAAAAAAAAAAAAAAAAAAAAAAAAAJ/f38AAAAAA8zMzADAwP8Af39/AAAAAAAAAAAAAAAAAAAAAAAAAAAAIQAAABgAAAAUAAAAOAQAALgaAAD4JQAACDQAABAAAAAmAAAACAAAAL0/AAAAAAAA"/>
+                <pr:smNativeData xmlns:pr="smNativeData" xmlns="smNativeData" val="SMDATA_15_bQt8ZhMAAAAlAAAAZAAAAA0AAAAAkAAAAJAAAACQAAAAkAAAAAAAAAAAAAAAAAAAAAEAAABQAAAAAAAAAAAA4D8AAAAAAADgPwAAAAAAAOA/AAAAAAAA4D8AAAAAAADgPwAAAAAAAOA/AAAAAAAA4D8AAAAAAADgPwAAAAAAAOA/AAAAAAAA4D8CAAAAjAAAAAAAAAAAAAAAQoX0DP///wgAAAAAAAAAAAAAAAAAAAAAAAAAAAAAAAAAAAAAZAAAAAEAAABAAAAAAAAAAAAAAAAAAAAAAAAAAAAAAAAAAAAAAAAAAAAAAAAAAAAAAAAAAAAAAAAAAAAAAAAAAAAAAAAAAAAAAAAAAAAAAAAAAAAAAAAAAAAAAAAAAAAAFAAAADwAAAAAAAAAAAAAAAAAAAkUAAAAAQAAABQAAAAUAAAAFAAAAAEAAAAAAAAAZAAAAGQAAAAAAAAAZAAAAGQAAAAVAAAAYAAAAAAAAAAAAAAADwAAACADAAAAAAAAAAAAAAEAAACgMgAAVgcAAKr4//8BAAAAf39/AAEAAABkAAAAAAAAABQAAABAHwAAAAAAACYAAAAAAAAAwOD//wAAAAAmAAAAZAAAABYAAABMAAAAAAAAAAAAAAAEAAAAAAAAAAEAAABZWVkKAAAAACgAAAAoAAAAZAAAAGQAAAAAAAAAzMzMAAAAAABQAAAAUAAAAGQAAABkAAAAAAAAABcAAAAUAAAAAAAAAAAAAAD/fwAA/38AAAAAAAAJAAAABAAAAF8AYAAeAAAAaAAAAAAAAAAAAAAAAAAAAAAAAAAAAAAAECcAABAnAAAAAAAAAAAAAAAAAAAAAAAAAAAAAAAAAAAAAAAAAAAAABQAAAAAAAAAwMD/AAAAAABkAAAAMgAAAAAAAABkAAAAAAAAAH9/fwAKAAAAIgAAABgAAAAAAAAAAAAAAAAAAAAAAAAAAAAAAAAAAAAkAAAAJAAAAAAAAAAHAAAAAAAAAAAAAAAAAAAAAAAAAAAAAAAAAAAAf39/ACUAAABYAAAAAAAAAAAAAAAAAAAAAAAAAAAAAAAAAAAAAAAAAAAAAAAAAAAAAAAAAAAAAAA/AAAAAAAAAKCGAQAAAAAAAAAAAAAAAAAMAAAAAQAAAAAAAAAAAAAAAAAAAB8AAABUAAAAAAAABQAAAAEAAAAAAAAAAAAAAAAAAAAAAAAAAAAAAAAAAAAAAAAAAAAAAAJ/f38AAAAAA8zMzADAwP8Af39/AAAAAAAAAAAAAAAAAAAAAAAAAAAAIQAAABgAAAAUAAAAOAQAALgaAAD4JQAACDQAABAAAAAmAAAACAAAAL0/AAAAAAAA"/>
               </a:ext>
             </a:extLst>
           </p:cNvSpPr>
@@ -1804,7 +1804,7 @@
             <a:spLocks noGrp="1" noChangeArrowheads="1"/>
             <a:extLst>
               <a:ext uri="smNativeData">
-                <pr:smNativeData xmlns:pr="smNativeData" xmlns="smNativeData" val="SMDATA_15_9kV5ZhMAAAAlAAAACwAAAA0AAAAACAcAADgEAAAoIwAAUBkAAAAAAAAAAAAAAAAAAAEAAABQAAAAAAAAAAAA4D8AAAAAAADgPwAAAAAAAOA/AAAAAAAA4D8AAAAAAADgPwAAAAAAAOA/AAAAAAAA4D8AAAAAAADgPwAAAAAAAOA/AAAAAAAA4D8CAAAAjAAAAAAAAAAAAAAAQoX0DP///wgAAAAAAAAAAAAAAAAAAAAAAAAAAAAAAAAAAAAAZAAAAAEAAABAAAAAAAAAAAAAAAAAAAAAAAAAAAAAAAAAAAAAAAAAAAAAAAAAAAAAAAAAAAAAAAAAAAAAAAAAAAAAAAAAAAAAAAAAAAAAAAAAAAAAAAAAAAAAAAAAAAAAFAAAADwAAAABAAAAAAAAAAAAAAAPAAAAAQAAACMAAAAjAAAAIwAAAB4AAAAAAAAASwAAAEsAAAAAAAAASwAAAEsAAAAVAAAAYAAAAAAAAAAAAAAADwAAACADAAAAAAAAAAAAAAEAAACgMgAAVgcAAKr4//8BAAAAf39/AAEAAABkAAAAAAAAABQAAABAHwAAAAAAACYAAAAAAAAAwOD//wAAAAAmAAAAZAAAABYAAABMAAAAAAAAAAAAAAAEAAAAAAAAAAEAAABZWVkKAAAAACgAAAAoAAAAZAAAAGQAAAAAAAAAzMzMAAAAAABQAAAAUAAAAGQAAABkAAAAAAAAABcAAAAUAAAAAAAAAAAAAAD/fwAA/38AAAAAAAAJAAAABAAAAAAAAAAeAAAAaAAAAAAAAAAAAAAAAAAAAAAAAAAAAAAAECcAABAnAAAAAAAAAAAAAAAAAAAAAAAAAAAAAAAAAAAAAAAAAAAAABQAAAAAAAAAwMD/AAAAAABkAAAAMgAAAAAAAABkAAAAAAAAAH9/fwAKAAAAIgAAABgAAAAAAAAAAAAAAAAAAAAAAAAAAAAAAAAAAAAkAAAAJAAAAAAAAAAHAAAAAAAAAAAAAAAAAAAAAAAAAAAAAAAAAAAAf39/ACUAAABYAAAAAAAAAAAAAAAAAAAAAAAAAAAAAAAAAAAAAAAAAAAAAAAAAAAAAAAAAAAAAAA/AAAAAAAAAKCGAQAAAAAAAAAAAAAAAAAMAAAAAQAAAAAAAAAAAAAAAAAAAB8AAABUAAAAAAAABQAAAAEAAAAAAAAAAAAAAAAAAAAAAAAAAAAAAAAAAAAAAAAAAAAAAAB/f38AAAAAA8zMzADAwP8Af39/AAAAAAAAAAAAAAAAAAAAAAAAAAAAIQAAABgAAAAUAAAACAcAADgEAAAoIwAAUBkAABAAAAAmAAAACAAAAAEPAAAAAAAA"/>
+                <pr:smNativeData xmlns:pr="smNativeData" xmlns="smNativeData" val="SMDATA_15_bQt8ZhMAAAAlAAAACwAAAA0AAAAACAcAADgEAAAoIwAAUBkAAAAAAAAAAAAAAAAAAAEAAABQAAAAAAAAAAAA4D8AAAAAAADgPwAAAAAAAOA/AAAAAAAA4D8AAAAAAADgPwAAAAAAAOA/AAAAAAAA4D8AAAAAAADgPwAAAAAAAOA/AAAAAAAA4D8CAAAAjAAAAAAAAAAAAAAAQoX0DP///wgAAAAAAAAAAAAAAAAAAAAAAAAAAAAAAAAAAAAAZAAAAAEAAABAAAAAAAAAAAAAAAAAAAAAAAAAAAAAAAAAAAAAAAAAAAAAAAAAAAAAAAAAAAAAAAAAAAAAAAAAAAAAAAAAAAAAAAAAAAAAAAAAAAAAAAAAAAAAAAAAAAAAFAAAADwAAAABAAAAAAAAAAAAAAAPAAAAAQAAACMAAAAjAAAAIwAAAB4AAAAAAAAASwAAAEsAAAAAAAAASwAAAEsAAAAVAAAAYAAAAAAAAAAAAAAADwAAACADAAAAAAAAAAAAAAEAAACgMgAAVgcAAKr4//8BAAAAf39/AAEAAABkAAAAAAAAABQAAABAHwAAAAAAACYAAAAAAAAAwOD//wAAAAAmAAAAZAAAABYAAABMAAAAAAAAAAAAAAAEAAAAAAAAAAEAAABZWVkKAAAAACgAAAAoAAAAZAAAAGQAAAAAAAAAzMzMAAAAAABQAAAAUAAAAGQAAABkAAAAAAAAABcAAAAUAAAAAAAAAAAAAAD/fwAA/38AAAAAAAAJAAAABAAAAAAAAAAeAAAAaAAAAAAAAAAAAAAAAAAAAAAAAAAAAAAAECcAABAnAAAAAAAAAAAAAAAAAAAAAAAAAAAAAAAAAAAAAAAAAAAAABQAAAAAAAAAwMD/AAAAAABkAAAAMgAAAAAAAABkAAAAAAAAAH9/fwAKAAAAIgAAABgAAAAAAAAAAAAAAAAAAAAAAAAAAAAAAAAAAAAkAAAAJAAAAAAAAAAHAAAAAAAAAAAAAAAAAAAAAAAAAAAAAAAAAAAAf39/ACUAAABYAAAAAAAAAAAAAAAAAAAAAAAAAAAAAAAAAAAAAAAAAAAAAAAAAAAAAAAAAAAAAAA/AAAAAAAAAKCGAQAAAAAAAAAAAAAAAAAMAAAAAQAAAAAAAAAAAAAAAAAAAB8AAABUAAAAAAAABQAAAAEAAAAAAAAAAAAAAAAAAAAAAAAAAAAAAAAAAAAAAAAAAAAAAAB/f38AAAAAA8zMzADAwP8Af39/AAAAAAAAAAAAAAAAAAAAAAAAAAAAIQAAABgAAAAUAAAACAcAADgEAAAoIwAAUBkAABAAAAAmAAAACAAAAAEPAAAAAAAA"/>
               </a:ext>
             </a:extLst>
           </p:cNvSpPr>
@@ -1850,7 +1850,7 @@
             <a:spLocks noGrp="1" noChangeArrowheads="1"/>
             <a:extLst>
               <a:ext uri="smNativeData">
-                <pr:smNativeData xmlns:pr="smNativeData" xmlns="smNativeData" val="SMDATA_15_9kV5ZhMAAAAlAAAAZAAAAA0AAAAAkAAAAJAAAACQAAAAkAAAAAAAAAAAAAAAAAAAAAEAAABQAAAAAAAAAAAA4D8AAAAAAADgPwAAAAAAAOA/AAAAAAAA4D8AAAAAAADgPwAAAAAAAOA/AAAAAAAA4D8AAAAAAADgPwAAAAAAAOA/AAAAAAAA4D8CAAAAjAAAAAAAAAAAAAAAQoX0DP///wgAAAAAAAAAAAAAAAAAAAAAAAAAAAAAAAAAAAAAZAAAAAEAAABAAAAAAAAAAAAAAAAAAAAAAAAAAAAAAAAAAAAAAAAAAAAAAAAAAAAAAAAAAAAAAAAAAAAAAAAAAAAAAAAAAAAAAAAAAAAAAAAAAAAAAAAAAAAAAAAAAAAAFAAAADwAAAAAAAAAAAAAAAAAAAkUAAAAAQAAABQAAAAUAAAAFAAAAAEAAAAAAAAAZAAAAGQAAAAAAAAAZAAAAGQAAAAVAAAAYAAAAAAAAAAAAAAADwAAACADAAAAAAAAAAAAAAEAAACgMgAAVgcAAKr4//8BAAAAf39/AAEAAABkAAAAAAAAABQAAABAHwAAAAAAACYAAAAAAAAAwOD//wAAAAAmAAAAZAAAABYAAABMAAAAAAAAAAAAAAAEAAAAAAAAAAEAAABZWVkKAAAAACgAAAAoAAAAZAAAAGQAAAAAAAAAzMzMAAAAAABQAAAAUAAAAGQAAABkAAAAAAAAABcAAAAUAAAAAAAAAAAAAAD/fwAA/38AAAAAAAAJAAAABAAAAF8AYAAeAAAAaAAAAAAAAAAAAAAAAAAAAAAAAAAAAAAAECcAABAnAAAAAAAAAAAAAAAAAAAAAAAAAAAAAAAAAAAAAAAAAAAAABQAAAAAAAAAwMD/AAAAAABkAAAAMgAAAAAAAABkAAAAAAAAAH9/fwAKAAAAIgAAABgAAAAAAAAAAAAAAAAAAAAAAAAAAAAAAAAAAAAkAAAAJAAAAAAAAAAHAAAAAAAAAAAAAAAAAAAAAAAAAAAAAAAAAAAAf39/ACUAAABYAAAAAAAAAAAAAAAAAAAAAAAAAAAAAAAAAAAAAAAAAAAAAAAAAAAAAAAAAAAAAAA/AAAAAAAAAKCGAQAAAAAAAAAAAAAAAAAMAAAAAQAAAAAAAAAAAAAAAAAAAB8AAABUAAAAAAAABQAAAAEAAAAAAAAAAAAAAAAAAAAAAAAAAAAAAAAAAAAAAAAAAAAAAAJ/f38AAAAAA8zMzADAwP8Af39/AAAAAAAAAAAAAAAAAAAAAAAAAAAAIQAAABgAAAAUAAAAOAQAALgaAAD4JQAACDQAABAAAAAmAAAACAAAAL0/AAAAAAAA"/>
+                <pr:smNativeData xmlns:pr="smNativeData" xmlns="smNativeData" val="SMDATA_15_bQt8ZhMAAAAlAAAAZAAAAA0AAAAAkAAAAJAAAACQAAAAkAAAAAAAAAAAAAAAAAAAAAEAAABQAAAAAAAAAAAA4D8AAAAAAADgPwAAAAAAAOA/AAAAAAAA4D8AAAAAAADgPwAAAAAAAOA/AAAAAAAA4D8AAAAAAADgPwAAAAAAAOA/AAAAAAAA4D8CAAAAjAAAAAAAAAAAAAAAQoX0DP///wgAAAAAAAAAAAAAAAAAAAAAAAAAAAAAAAAAAAAAZAAAAAEAAABAAAAAAAAAAAAAAAAAAAAAAAAAAAAAAAAAAAAAAAAAAAAAAAAAAAAAAAAAAAAAAAAAAAAAAAAAAAAAAAAAAAAAAAAAAAAAAAAAAAAAAAAAAAAAAAAAAAAAFAAAADwAAAAAAAAAAAAAAAAAAAkUAAAAAQAAABQAAAAUAAAAFAAAAAEAAAAAAAAAZAAAAGQAAAAAAAAAZAAAAGQAAAAVAAAAYAAAAAAAAAAAAAAADwAAACADAAAAAAAAAAAAAAEAAACgMgAAVgcAAKr4//8BAAAAf39/AAEAAABkAAAAAAAAABQAAABAHwAAAAAAACYAAAAAAAAAwOD//wAAAAAmAAAAZAAAABYAAABMAAAAAAAAAAAAAAAEAAAAAAAAAAEAAABZWVkKAAAAACgAAAAoAAAAZAAAAGQAAAAAAAAAzMzMAAAAAABQAAAAUAAAAGQAAABkAAAAAAAAABcAAAAUAAAAAAAAAAAAAAD/fwAA/38AAAAAAAAJAAAABAAAAF8AYAAeAAAAaAAAAAAAAAAAAAAAAAAAAAAAAAAAAAAAECcAABAnAAAAAAAAAAAAAAAAAAAAAAAAAAAAAAAAAAAAAAAAAAAAABQAAAAAAAAAwMD/AAAAAABkAAAAMgAAAAAAAABkAAAAAAAAAH9/fwAKAAAAIgAAABgAAAAAAAAAAAAAAAAAAAAAAAAAAAAAAAAAAAAkAAAAJAAAAAAAAAAHAAAAAAAAAAAAAAAAAAAAAAAAAAAAAAAAAAAAf39/ACUAAABYAAAAAAAAAAAAAAAAAAAAAAAAAAAAAAAAAAAAAAAAAAAAAAAAAAAAAAAAAAAAAAA/AAAAAAAAAKCGAQAAAAAAAAAAAAAAAAAMAAAAAQAAAAAAAAAAAAAAAAAAAB8AAABUAAAAAAAABQAAAAEAAAAAAAAAAAAAAAAAAAAAAAAAAAAAAAAAAAAAAAAAAAAAAAJ/f38AAAAAA8zMzADAwP8Af39/AAAAAAAAAAAAAAAAAAAAAAAAAAAAIQAAABgAAAAUAAAAOAQAALgaAAD4JQAACDQAABAAAAAmAAAACAAAAL0/AAAAAAAA"/>
               </a:ext>
             </a:extLst>
           </p:cNvSpPr>
@@ -1927,7 +1927,7 @@
             <a:spLocks noGrp="1" noChangeArrowheads="1"/>
             <a:extLst>
               <a:ext uri="smNativeData">
-                <pr:smNativeData xmlns:pr="smNativeData" xmlns="smNativeData" val="SMDATA_15_9kV5ZhMAAAAlAAAACwAAAA0AAAAACAcAADgEAAAoIwAAUBkAAAAAAAAAAAAAAAAAAAEAAABQAAAAAAAAAAAA4D8AAAAAAADgPwAAAAAAAOA/AAAAAAAA4D8AAAAAAADgPwAAAAAAAOA/AAAAAAAA4D8AAAAAAADgPwAAAAAAAOA/AAAAAAAA4D8CAAAAjAAAAAAAAAAAAAAAQoX0DP///wgAAAAAAAAAAAAAAAAAAAAAAAAAAAAAAAAAAAAAZAAAAAEAAABAAAAAAAAAAAAAAAAAAAAAAAAAAAAAAAAAAAAAAAAAAAAAAAAAAAAAAAAAAAAAAAAAAAAAAAAAAAAAAAAAAAAAAAAAAAAAAAAAAAAAAAAAAAAAAAAAAAAAFAAAADwAAAABAAAAAAAAAAAAAAAPAAAAAQAAACMAAAAjAAAAIwAAAB4AAAAAAAAASwAAAEsAAAAAAAAASwAAAEsAAAAVAAAAYAAAAAAAAAAAAAAADwAAACADAAAAAAAAAAAAAAEAAACgMgAAVgcAAKr4//8BAAAAf39/AAEAAABkAAAAAAAAABQAAABAHwAAAAAAACYAAAAAAAAAwOD//wAAAAAmAAAAZAAAABYAAABMAAAAAAAAAAAAAAAEAAAAAAAAAAEAAABZWVkKAAAAACgAAAAoAAAAZAAAAGQAAAAAAAAAzMzMAAAAAABQAAAAUAAAAGQAAABkAAAAAAAAABcAAAAUAAAAAAAAAAAAAAD/fwAA/38AAAAAAAAJAAAABAAAAAAAAAAeAAAAaAAAAAAAAAAAAAAAAAAAAAAAAAAAAAAAECcAABAnAAAAAAAAAAAAAAAAAAAAAAAAAAAAAAAAAAAAAAAAAAAAABQAAAAAAAAAwMD/AAAAAABkAAAAMgAAAAAAAABkAAAAAAAAAH9/fwAKAAAAIgAAABgAAAAAAAAAAAAAAAAAAAAAAAAAAAAAAAAAAAAkAAAAJAAAAAAAAAAHAAAAAAAAAAAAAAAAAAAAAAAAAAAAAAAAAAAAf39/ACUAAABYAAAAAAAAAAAAAAAAAAAAAAAAAAAAAAAAAAAAAAAAAAAAAAAAAAAAAAAAAAAAAAA/AAAAAAAAAKCGAQAAAAAAAAAAAAAAAAAMAAAAAQAAAAAAAAAAAAAAAAAAAB8AAABUAAAAAAAABQAAAAEAAAAAAAAAAAAAAAAAAAAAAAAAAAAAAAAAAAAAAAAAAAAAAAB/f38AAAAAA8zMzADAwP8Af39/AAAAAAAAAAAAAAAAAAAAAAAAAAAAIQAAABgAAAAUAAAACAcAADgEAAAoIwAAUBkAABAAAAAmAAAACAAAAAEPAAAAAAAA"/>
+                <pr:smNativeData xmlns:pr="smNativeData" xmlns="smNativeData" val="SMDATA_15_bQt8ZhMAAAAlAAAACwAAAA0AAAAACAcAADgEAAAoIwAAUBkAAAAAAAAAAAAAAAAAAAEAAABQAAAAAAAAAAAA4D8AAAAAAADgPwAAAAAAAOA/AAAAAAAA4D8AAAAAAADgPwAAAAAAAOA/AAAAAAAA4D8AAAAAAADgPwAAAAAAAOA/AAAAAAAA4D8CAAAAjAAAAAAAAAAAAAAAQoX0DP///wgAAAAAAAAAAAAAAAAAAAAAAAAAAAAAAAAAAAAAZAAAAAEAAABAAAAAAAAAAAAAAAAAAAAAAAAAAAAAAAAAAAAAAAAAAAAAAAAAAAAAAAAAAAAAAAAAAAAAAAAAAAAAAAAAAAAAAAAAAAAAAAAAAAAAAAAAAAAAAAAAAAAAFAAAADwAAAABAAAAAAAAAAAAAAAPAAAAAQAAACMAAAAjAAAAIwAAAB4AAAAAAAAASwAAAEsAAAAAAAAASwAAAEsAAAAVAAAAYAAAAAAAAAAAAAAADwAAACADAAAAAAAAAAAAAAEAAACgMgAAVgcAAKr4//8BAAAAf39/AAEAAABkAAAAAAAAABQAAABAHwAAAAAAACYAAAAAAAAAwOD//wAAAAAmAAAAZAAAABYAAABMAAAAAAAAAAAAAAAEAAAAAAAAAAEAAABZWVkKAAAAACgAAAAoAAAAZAAAAGQAAAAAAAAAzMzMAAAAAABQAAAAUAAAAGQAAABkAAAAAAAAABcAAAAUAAAAAAAAAAAAAAD/fwAA/38AAAAAAAAJAAAABAAAAAAAAAAeAAAAaAAAAAAAAAAAAAAAAAAAAAAAAAAAAAAAECcAABAnAAAAAAAAAAAAAAAAAAAAAAAAAAAAAAAAAAAAAAAAAAAAABQAAAAAAAAAwMD/AAAAAABkAAAAMgAAAAAAAABkAAAAAAAAAH9/fwAKAAAAIgAAABgAAAAAAAAAAAAAAAAAAAAAAAAAAAAAAAAAAAAkAAAAJAAAAAAAAAAHAAAAAAAAAAAAAAAAAAAAAAAAAAAAAAAAAAAAf39/ACUAAABYAAAAAAAAAAAAAAAAAAAAAAAAAAAAAAAAAAAAAAAAAAAAAAAAAAAAAAAAAAAAAAA/AAAAAAAAAKCGAQAAAAAAAAAAAAAAAAAMAAAAAQAAAAAAAAAAAAAAAAAAAB8AAABUAAAAAAAABQAAAAEAAAAAAAAAAAAAAAAAAAAAAAAAAAAAAAAAAAAAAAAAAAAAAAB/f38AAAAAA8zMzADAwP8Af39/AAAAAAAAAAAAAAAAAAAAAAAAAAAAIQAAABgAAAAUAAAACAcAADgEAAAoIwAAUBkAABAAAAAmAAAACAAAAAEPAAAAAAAA"/>
               </a:ext>
             </a:extLst>
           </p:cNvSpPr>
@@ -1973,7 +1973,7 @@
             <a:spLocks noGrp="1" noChangeArrowheads="1"/>
             <a:extLst>
               <a:ext uri="smNativeData">
-                <pr:smNativeData xmlns:pr="smNativeData" xmlns="smNativeData" val="SMDATA_15_9kV5ZhMAAAAlAAAAZAAAAA0AAAAAkAAAAJAAAACQAAAAkAAAAAAAAAAAAAAAAAAAAAEAAABQAAAAAAAAAAAA4D8AAAAAAADgPwAAAAAAAOA/AAAAAAAA4D8AAAAAAADgPwAAAAAAAOA/AAAAAAAA4D8AAAAAAADgPwAAAAAAAOA/AAAAAAAA4D8CAAAAjAAAAAAAAAAAAAAAQoX0DP///wgAAAAAAAAAAAAAAAAAAAAAAAAAAAAAAAAAAAAAZAAAAAEAAABAAAAAAAAAAAAAAAAAAAAAAAAAAAAAAAAAAAAAAAAAAAAAAAAAAAAAAAAAAAAAAAAAAAAAAAAAAAAAAAAAAAAAAAAAAAAAAAAAAAAAAAAAAAAAAAAAAAAAFAAAADwAAAAAAAAAAAAAAAAAAAkUAAAAAQAAABQAAAAUAAAAFAAAAAEAAAAAAAAAZAAAAGQAAAAAAAAAZAAAAGQAAAAVAAAAYAAAAAAAAAAAAAAADwAAACADAAAAAAAAAAAAAAEAAACgMgAAVgcAAKr4//8BAAAAf39/AAEAAABkAAAAAAAAABQAAABAHwAAAAAAACYAAAAAAAAAwOD//wAAAAAmAAAAZAAAABYAAABMAAAAAAAAAAAAAAAEAAAAAAAAAAEAAABZWVkKAAAAACgAAAAoAAAAZAAAAGQAAAAAAAAAzMzMAAAAAABQAAAAUAAAAGQAAABkAAAAAAAAABcAAAAUAAAAAAAAAAAAAAD/fwAA/38AAAAAAAAJAAAABAAAAPDbzXceAAAAaAAAAAAAAAAAAAAAAAAAAAAAAAAAAAAAECcAABAnAAAAAAAAAAAAAAAAAAAAAAAAAAAAAAAAAAAAAAAAAAAAABQAAAAAAAAAwMD/AAAAAABkAAAAMgAAAAAAAABkAAAAAAAAAH9/fwAKAAAAIgAAABgAAAAAAAAAAAAAAAAAAAAAAAAAAAAAAAAAAAAkAAAAJAAAAAAAAAAHAAAAAAAAAAAAAAAAAAAAAAAAAAAAAAAAAAAAf39/ACUAAABYAAAAAAAAAAAAAAAAAAAAAAAAAAAAAAAAAAAAAAAAAAAAAAAAAAAAAAAAAAAAAAA/AAAAAAAAAKCGAQAAAAAAAAAAAAAAAAAMAAAAAQAAAAAAAAAAAAAAAAAAAB8AAABUAAAAAAAABQAAAAEAAAAAAAAAAAAAAAAAAAAAAAAAAAAAAAAAAAAAAAAAAAAAAAJ/f38AAAAAA8zMzADAwP8Af39/AAAAAAAAAAAAAAAAAAAAAAAAAAAAIQAAABgAAAAUAAAAOAQAALgaAAD4JQAACDQAABAAAAAmAAAACAAAAL0/AAAAAAAA"/>
+                <pr:smNativeData xmlns:pr="smNativeData" xmlns="smNativeData" val="SMDATA_15_bQt8ZhMAAAAlAAAAZAAAAA0AAAAAkAAAAJAAAACQAAAAkAAAAAAAAAAAAAAAAAAAAAEAAABQAAAAAAAAAAAA4D8AAAAAAADgPwAAAAAAAOA/AAAAAAAA4D8AAAAAAADgPwAAAAAAAOA/AAAAAAAA4D8AAAAAAADgPwAAAAAAAOA/AAAAAAAA4D8CAAAAjAAAAAAAAAAAAAAAQoX0DP///wgAAAAAAAAAAAAAAAAAAAAAAAAAAAAAAAAAAAAAZAAAAAEAAABAAAAAAAAAAAAAAAAAAAAAAAAAAAAAAAAAAAAAAAAAAAAAAAAAAAAAAAAAAAAAAAAAAAAAAAAAAAAAAAAAAAAAAAAAAAAAAAAAAAAAAAAAAAAAAAAAAAAAFAAAADwAAAAAAAAAAAAAAAAAAAkUAAAAAQAAABQAAAAUAAAAFAAAAAEAAAAAAAAAZAAAAGQAAAAAAAAAZAAAAGQAAAAVAAAAYAAAAAAAAAAAAAAADwAAACADAAAAAAAAAAAAAAEAAACgMgAAVgcAAKr4//8BAAAAf39/AAEAAABkAAAAAAAAABQAAABAHwAAAAAAACYAAAAAAAAAwOD//wAAAAAmAAAAZAAAABYAAABMAAAAAAAAAAAAAAAEAAAAAAAAAAEAAABZWVkKAAAAACgAAAAoAAAAZAAAAGQAAAAAAAAAzMzMAAAAAABQAAAAUAAAAGQAAABkAAAAAAAAABcAAAAUAAAAAAAAAAAAAAD/fwAA/38AAAAAAAAJAAAABAAAAPDbzXceAAAAaAAAAAAAAAAAAAAAAAAAAAAAAAAAAAAAECcAABAnAAAAAAAAAAAAAAAAAAAAAAAAAAAAAAAAAAAAAAAAAAAAABQAAAAAAAAAwMD/AAAAAABkAAAAMgAAAAAAAABkAAAAAAAAAH9/fwAKAAAAIgAAABgAAAAAAAAAAAAAAAAAAAAAAAAAAAAAAAAAAAAkAAAAJAAAAAAAAAAHAAAAAAAAAAAAAAAAAAAAAAAAAAAAAAAAAAAAf39/ACUAAABYAAAAAAAAAAAAAAAAAAAAAAAAAAAAAAAAAAAAAAAAAAAAAAAAAAAAAAAAAAAAAAA/AAAAAAAAAKCGAQAAAAAAAAAAAAAAAAAMAAAAAQAAAAAAAAAAAAAAAAAAAB8AAABUAAAAAAAABQAAAAEAAAAAAAAAAAAAAAAAAAAAAAAAAAAAAAAAAAAAAAAAAAAAAAJ/f38AAAAAA8zMzADAwP8Af39/AAAAAAAAAAAAAAAAAAAAAAAAAAAAIQAAABgAAAAUAAAAOAQAALgaAAD4JQAACDQAABAAAAAmAAAACAAAAL0/AAAAAAAA"/>
               </a:ext>
             </a:extLst>
           </p:cNvSpPr>
@@ -2041,7 +2041,7 @@
           <p:cNvPicPr>
             <a:extLst>
               <a:ext uri="smNativeData">
-                <pr:smNativeData xmlns:pr="smNativeData" xmlns="smNativeData" val="SMDATA_17_9kV5ZhMAAAAlAAAAEQAAAA0AAAAAkAAAAEgAAACQAAAASAAAAAAAAAAAAAAAAAAAAAEAAABQAAAAAAAAAAAA4D8AAAAAAADgPwAAAAAAAOA/AAAAAAAA4D8AAAAAAADgPwAAAAAAAOA/AAAAAAAA4D8AAAAAAADgPwAAAAAAAOA/AAAAAAAA4D8CAAAAjAAAAAAAAAAAAAAAQoX0DP///wgAAAAAAAAAAAAAAAAAAAAAAAAAAAAAAAAAAAAAZAAAAAEAAABAAAAAAAAAAAAAAAAAAAAAAAAAAAAAAAAAAAAAAAAAAAAAAAAAAAAAAAAAAAAAAAAAAAAAAAAAAAAAAAAAAAAAAAAAAAAAAAAAAAAAAAAAAAAAAAAAAAAAFAAAADwAAAAAAAAAAAAAAAAAAAkUAAAAAQAAABQAAAAUAAAAFAAAAAEAAAAAAAAAZAAAAGQAAAAAAAAAZAAAAGQAAAAVAAAAYAAAAAAAAAAAAAAADwAAACADAAAAAAAAAAAAAAEAAACgMgAAVgcAAKr4//8BAAAAf39/AAEAAABkAAAAAAAAABQAAABAHwAAAAAAACYAAAAAAAAAwOD//wAAAAAmAAAAZAAAABYAAABMAAAAAAAAAAAAAAAEAAAAAAAAAAEAAABZWVkKAAAAACgAAAAoAAAAZAAAAGQAAAAAAAAAzMzMAAAAAABQAAAAUAAAAGQAAABkAAAAAAAAAAcAAAA4AAAAAAAAAAAAAAAAAAAA////AAAAAAAAAAAAAAAAAAAAAAAAAAAAAAAAAAAAAABkAAAAZAAAAAAAAAAjAAAABAAAAGQAAAAXAAAAFAAAAAAAAAAAAAAA/38AAP9/AAAAAAAACQAAAAQAAAAlAwAAHgAAAGgAAAAAAAAAAAAAAAAAAAAAAAAAAAAAABAnAAAQJwAAAAAAAAAAAAAAAAAAAAAAAAAAAAAAAAAAAAAAAAAAAAAUAAAAAAAAAMDA/wAAAAAAZAAAADIAAAAAAAAAZAAAAAAAAAB/f38ACgAAACIAAAAYAAAAAAAAAAAAAAAAAAAAAAAAAAAAAAAAAAAAJAAAACQAAAAAAAAABwAAAAAAAAAAAAAAAAAAAAAAAAAAAAAAAAAAAH9/fwAlAAAAWAAAAAAAAAAAAAAAAAAAAAAAAAAAAAAAAAAAAAAAAAAAAAAAAAAAAAAAAAAAAAAAPwAAAAAAAACghgEAAAAAAAAAAAAAAAAADAAAAAEAAAAAAAAAAAAAAAAAAAAfAAAAVAAAAEKF9AX///8BAAAAAAAAAAAAAAAAAAAAAAAAAAAAAAAAAAAAAAAAAAAAAAACf39/AFlZWQPMzMwAwMD/AH9/fwAAAAAAAAAAAAAAAAD///8AAAAAACEAAAAYAAAAFAAAAOT////r////XDgAAEUqAAAQAAAAJgAAAAgAAAD//////////w=="/>
+                <pr:smNativeData xmlns:pr="smNativeData" xmlns="smNativeData" val="SMDATA_17_bQt8ZhMAAAAlAAAAEQAAAA0AAAAAkAAAAEgAAACQAAAASAAAAAAAAAAAAAAAAAAAAAEAAABQAAAAAAAAAAAA4D8AAAAAAADgPwAAAAAAAOA/AAAAAAAA4D8AAAAAAADgPwAAAAAAAOA/AAAAAAAA4D8AAAAAAADgPwAAAAAAAOA/AAAAAAAA4D8CAAAAjAAAAAAAAAAAAAAAQoX0DP///wgAAAAAAAAAAAAAAAAAAAAAAAAAAAAAAAAAAAAAZAAAAAEAAABAAAAAAAAAAAAAAAAAAAAAAAAAAAAAAAAAAAAAAAAAAAAAAAAAAAAAAAAAAAAAAAAAAAAAAAAAAAAAAAAAAAAAAAAAAAAAAAAAAAAAAAAAAAAAAAAAAAAAFAAAADwAAAAAAAAAAAAAAAAAAAkUAAAAAQAAABQAAAAUAAAAFAAAAAEAAAAAAAAAZAAAAGQAAAAAAAAAZAAAAGQAAAAVAAAAYAAAAAAAAAAAAAAADwAAACADAAAAAAAAAAAAAAEAAACgMgAAVgcAAKr4//8BAAAAf39/AAEAAABkAAAAAAAAABQAAABAHwAAAAAAACYAAAAAAAAAwOD//wAAAAAmAAAAZAAAABYAAABMAAAAAAAAAAAAAAAEAAAAAAAAAAEAAABZWVkKAAAAACgAAAAoAAAAZAAAAGQAAAAAAAAAzMzMAAAAAABQAAAAUAAAAGQAAABkAAAAAAAAAAcAAAA4AAAAAAAAAAAAAAAAAAAA////AAAAAAAAAAAAAAAAAAAAAAAAAAAAAAAAAAAAAABkAAAAZAAAAAAAAAAjAAAABAAAAGQAAAAXAAAAFAAAAAAAAAAAAAAA/38AAP9/AAAAAAAACQAAAAQAAAAlAwAAHgAAAGgAAAAAAAAAAAAAAAAAAAAAAAAAAAAAABAnAAAQJwAAAAAAAAAAAAAAAAAAAAAAAAAAAAAAAAAAAAAAAAAAAAAUAAAAAAAAAMDA/wAAAAAAZAAAADIAAAAAAAAAZAAAAAAAAAB/f38ACgAAACIAAAAYAAAAAAAAAAAAAAAAAAAAAAAAAAAAAAAAAAAAJAAAACQAAAAAAAAABwAAAAAAAAAAAAAAAAAAAAAAAAAAAAAAAAAAAH9/fwAlAAAAWAAAAAAAAAAAAAAAAAAAAAAAAAAAAAAAAAAAAAAAAAAAAAAAAAAAAAAAAAAAAAAAPwAAAAAAAACghgEAAAAAAAAAAAAAAAAADAAAAAEAAAAAAAAAAAAAAAAAAAAfAAAAVAAAAEKF9AX///8BAAAAAAAAAAAAAAAAAAAAAAAAAAAAAAAAAAAAAAAAAAAAAAACf39/AFlZWQPMzMwAwMD/AH9/fwAAAAAAAAAAAAAAAAD///8AAAAAACEAAAAYAAAAFAAAAOT////r////XDgAAEUqAAAQAAAAJgAAAAgAAAD//////////w=="/>
               </a:ext>
             </a:extLst>
           </p:cNvPicPr>
@@ -2075,7 +2075,7 @@
             <a:spLocks noGrp="1" noChangeArrowheads="1"/>
             <a:extLst>
               <a:ext uri="smNativeData">
-                <pr:smNativeData xmlns:pr="smNativeData" xmlns="smNativeData" val="SMDATA_15_9kV5ZhMAAAAlAAAAZAAAAA0AAAAAkAAAAJAAAACQAAAAkAAAAAAAAAAAAAAAAAAAAAEAAABQAAAAAAAAAAAA4D8AAAAAAADgPwAAAAAAAOA/AAAAAAAA4D8AAAAAAADgPwAAAAAAAOA/AAAAAAAA4D8AAAAAAADgPwAAAAAAAOA/AAAAAAAA4D8CAAAAjAAAAAAAAAAAAAAAQoX0DP///wgAAAAAAAAAAAAAAAAAAAAAAAAAAAAAAAAAAAAAZAAAAAEAAABAAAAAAAAAAAAAAAAAAAAAAAAAAAAAAAAAAAAAAAAAAAAAAAAAAAAAAAAAAAAAAAAAAAAAAAAAAAAAAAAAAAAAAAAAAAAAAAAAAAAAAAAAAAAAAAAAAAAAFAAAADwAAAAAAAAAAAAAAAAAAAkUAAAAAQAAABQAAAAUAAAAFAAAAAEAAAAAAAAAZAAAAGQAAAAAAAAAZAAAAGQAAAAVAAAAYAAAAAAAAAAAAAAADwAAACADAAAAAAAAAAAAAAEAAACgMgAAVgcAAKr4//8BAAAAf39/AAEAAABkAAAAAAAAABQAAABAHwAAAAAAACYAAAAAAAAAwOD//wAAAAAmAAAAZAAAABYAAABMAAAAAAAAAAAAAAAEAAAAAAAAAAEAAABZWVkKAAAAACgAAAAoAAAAZAAAAGQAAAAAAAAAzMzMAAAAAABQAAAAUAAAAGQAAABkAAAAAAAAABcAAAAUAAAAAAAAAAAAAAD/fwAA/38AAAAAAAAJAAAABAAAAAAAAAAeAAAAaAAAAAAAAAAAAAAAAAAAAAAAAAAAAAAAECcAABAnAAAAAAAAAAAAAAAAAAAAAAAAAAAAAAAAAAAAAAAAAAAAABQAAAAAAAAAwMD/AAAAAABkAAAAMgAAAAAAAABkAAAAAAAAAH9/fwAKAAAAIgAAABgAAAAAAAAAAAAAAAAAAAAAAAAAAAAAAAAAAAAkAAAAJAAAAAAAAAAHAAAAAAAAAAAAAAAAAAAAAAAAAAAAAAAAAAAAf39/ACUAAABYAAAAAAAAAAAAAAAAAAAAAAAAAAAAAAAAAAAAAAAAAAAAAAAAAAAAAAAAAAAAAAA/AAAAAAAAAKCGAQAAAAAAAAAAAAAAAAAMAAAAAQAAAAAAAAAAAAAAAAAAAB8AAABUAAAAAAAABQAAAAEAAAAAAAAAAAAAAAAAAAAAAAAAAAAAAAAAAAAAAAAAAAAAAAJ/f38AAAAAA8zMzADAwP8Af39/AAAAAAAAAAAAAAAAAAAAAAAAAAAAIQAAABgAAAAUAAAA5wQAAD8jAAD6IwAAvykAABAAAAAmAAAACAAAAD2wAAAAAAAA"/>
+                <pr:smNativeData xmlns:pr="smNativeData" xmlns="smNativeData" val="SMDATA_15_bQt8ZhMAAAAlAAAAZAAAAA0AAAAAkAAAAJAAAACQAAAAkAAAAAAAAAAAAAAAAAAAAAEAAABQAAAAAAAAAAAA4D8AAAAAAADgPwAAAAAAAOA/AAAAAAAA4D8AAAAAAADgPwAAAAAAAOA/AAAAAAAA4D8AAAAAAADgPwAAAAAAAOA/AAAAAAAA4D8CAAAAjAAAAAAAAAAAAAAAQoX0DP///wgAAAAAAAAAAAAAAAAAAAAAAAAAAAAAAAAAAAAAZAAAAAEAAABAAAAAAAAAAAAAAAAAAAAAAAAAAAAAAAAAAAAAAAAAAAAAAAAAAAAAAAAAAAAAAAAAAAAAAAAAAAAAAAAAAAAAAAAAAAAAAAAAAAAAAAAAAAAAAAAAAAAAFAAAADwAAAAAAAAAAAAAAAAAAAkUAAAAAQAAABQAAAAUAAAAFAAAAAEAAAAAAAAAZAAAAGQAAAAAAAAAZAAAAGQAAAAVAAAAYAAAAAAAAAAAAAAADwAAACADAAAAAAAAAAAAAAEAAACgMgAAVgcAAKr4//8BAAAAf39/AAEAAABkAAAAAAAAABQAAABAHwAAAAAAACYAAAAAAAAAwOD//wAAAAAmAAAAZAAAABYAAABMAAAAAAAAAAAAAAAEAAAAAAAAAAEAAABZWVkKAAAAACgAAAAoAAAAZAAAAGQAAAAAAAAAzMzMAAAAAABQAAAAUAAAAGQAAABkAAAAAAAAABcAAAAUAAAAAAAAAAAAAAD/fwAA/38AAAAAAAAJAAAABAAAAAAAAAAeAAAAaAAAAAAAAAAAAAAAAAAAAAAAAAAAAAAAECcAABAnAAAAAAAAAAAAAAAAAAAAAAAAAAAAAAAAAAAAAAAAAAAAABQAAAAAAAAAwMD/AAAAAABkAAAAMgAAAAAAAABkAAAAAAAAAH9/fwAKAAAAIgAAABgAAAAAAAAAAAAAAAAAAAAAAAAAAAAAAAAAAAAkAAAAJAAAAAAAAAAHAAAAAAAAAAAAAAAAAAAAAAAAAAAAAAAAAAAAf39/ACUAAABYAAAAAAAAAAAAAAAAAAAAAAAAAAAAAAAAAAAAAAAAAAAAAAAAAAAAAAAAAAAAAAA/AAAAAAAAAKCGAQAAAAAAAAAAAAAAAAAMAAAAAQAAAAAAAAAAAAAAAAAAAB8AAABUAAAAAAAABQAAAAEAAAAAAAAAAAAAAAAAAAAAAAAAAAAAAAAAAAAAAAAAAAAAAAJ/f38AAAAAA8zMzADAwP8Af39/AAAAAAAAAAAAAAAAAAAAAAAAAAAAIQAAABgAAAAUAAAA5wQAAD8jAAD6IwAAvykAABAAAAAmAAAACAAAAD2wAAAAAAAA"/>
               </a:ext>
             </a:extLst>
           </p:cNvSpPr>
@@ -2230,7 +2230,7 @@
             <a:spLocks noGrp="1" noChangeArrowheads="1"/>
             <a:extLst>
               <a:ext uri="smNativeData">
-                <pr:smNativeData xmlns:pr="smNativeData" xmlns="smNativeData" val="SMDATA_15_9kV5ZhMAAAAlAAAAZAAAAA0AAAAAkAAAAJAAAACQAAAAkAAAAAAAAAAAAAAAAAAAAAEAAABQAAAAAAAAAAAA4D8AAAAAAADgPwAAAAAAAOA/AAAAAAAA4D8AAAAAAADgPwAAAAAAAOA/AAAAAAAA4D8AAAAAAADgPwAAAAAAAOA/AAAAAAAA4D8CAAAAjAAAAAAAAAAAAAAAQoX0DP///wgAAAAAAAAAAAAAAAAAAAAAAAAAAAAAAAAAAAAAZAAAAAEAAABAAAAAAAAAAAAAAAAAAAAAAAAAAAAAAAAAAAAAAAAAAAAAAAAAAAAAAAAAAAAAAAAAAAAAAAAAAAAAAAAAAAAAAAAAAAAAAAAAAAAAAAAAAAAAAAAAAAAAFAAAADwAAAAAAAAAAAAAAAAAAAkUAAAAAQAAABQAAAAUAAAAFAAAAAEAAAAAAAAAZAAAAGQAAAAAAAAAZAAAAGQAAAAVAAAAYAAAAAAAAAAAAAAADwAAACADAAAAAAAAAAAAAAEAAACgMgAAVgcAAKr4//8BAAAAf39/AAEAAABkAAAAAAAAABQAAABAHwAAAAAAACYAAAAAAAAAwOD//wAAAAAmAAAAZAAAABYAAABMAAAAAAAAAAAAAAAEAAAAAAAAAAEAAABZWVkKAAAAACgAAAAoAAAAZAAAAGQAAAAAAAAAzMzMAAAAAABQAAAAUAAAAGQAAABkAAAAAAAAABcAAAAUAAAAAAAAAAAAAAD/fwAA/38AAAAAAAAJAAAABAAAAAAAAAAeAAAAaAAAAAAAAAAAAAAAAAAAAAAAAAAAAAAAECcAABAnAAAAAAAAAAAAAAAAAAAAAAAAAAAAAAAAAAAAAAAAAAAAABQAAAAAAAAAwMD/AAAAAABkAAAAMgAAAAAAAABkAAAAAAAAAH9/fwAKAAAAIgAAABgAAAAAAAAAAAAAAAAAAAAAAAAAAAAAAAAAAAAkAAAAJAAAAAAAAAAHAAAAAAAAAAAAAAAAAAAAAAAAAAAAAAAAAAAAf39/ACUAAABYAAAAAAAAAAAAAAAAAAAAAAAAAAAAAAAAAAAAAAAAAAAAAAAAAAAAAAAAAAAAAAA/AAAAAAAAAKCGAQAAAAAAAAAAAAAAAAAMAAAAAQAAAAAAAAAAAAAAAAAAAB8AAABUAAAAAAAABQAAAAEAAAAAAAAAAAAAAAAAAAAAAAAAAAAAAAAAAAAAAAAAAAAAAAJ/f38AAAAAA8zMzADAwP8Af39/AAAAAAAAAAAAAAAAAAAAAAAAAAAAIQAAABgAAAAUAAAA5wQAAMMPAACROAAAfyQAABAAAAAmAAAACAAAAD2wAAAAAAAA"/>
+                <pr:smNativeData xmlns:pr="smNativeData" xmlns="smNativeData" val="SMDATA_15_bQt8ZhMAAAAlAAAAZAAAAA0AAAAAkAAAAJAAAACQAAAAkAAAAAAAAAAAAAAAAAAAAAEAAABQAAAAAAAAAAAA4D8AAAAAAADgPwAAAAAAAOA/AAAAAAAA4D8AAAAAAADgPwAAAAAAAOA/AAAAAAAA4D8AAAAAAADgPwAAAAAAAOA/AAAAAAAA4D8CAAAAjAAAAAAAAAAAAAAAQoX0DP///wgAAAAAAAAAAAAAAAAAAAAAAAAAAAAAAAAAAAAAZAAAAAEAAABAAAAAAAAAAAAAAAAAAAAAAAAAAAAAAAAAAAAAAAAAAAAAAAAAAAAAAAAAAAAAAAAAAAAAAAAAAAAAAAAAAAAAAAAAAAAAAAAAAAAAAAAAAAAAAAAAAAAAFAAAADwAAAAAAAAAAAAAAAAAAAkUAAAAAQAAABQAAAAUAAAAFAAAAAEAAAAAAAAAZAAAAGQAAAAAAAAAZAAAAGQAAAAVAAAAYAAAAAAAAAAAAAAADwAAACADAAAAAAAAAAAAAAEAAACgMgAAVgcAAKr4//8BAAAAf39/AAEAAABkAAAAAAAAABQAAABAHwAAAAAAACYAAAAAAAAAwOD//wAAAAAmAAAAZAAAABYAAABMAAAAAAAAAAAAAAAEAAAAAAAAAAEAAABZWVkKAAAAACgAAAAoAAAAZAAAAGQAAAAAAAAAzMzMAAAAAABQAAAAUAAAAGQAAABkAAAAAAAAABcAAAAUAAAAAAAAAAAAAAD/fwAA/38AAAAAAAAJAAAABAAAAAAAAAAeAAAAaAAAAAAAAAAAAAAAAAAAAAAAAAAAAAAAECcAABAnAAAAAAAAAAAAAAAAAAAAAAAAAAAAAAAAAAAAAAAAAAAAABQAAAAAAAAAwMD/AAAAAABkAAAAMgAAAAAAAABkAAAAAAAAAH9/fwAKAAAAIgAAABgAAAAAAAAAAAAAAAAAAAAAAAAAAAAAAAAAAAAkAAAAJAAAAAAAAAAHAAAAAAAAAAAAAAAAAAAAAAAAAAAAAAAAAAAAf39/ACUAAABYAAAAAAAAAAAAAAAAAAAAAAAAAAAAAAAAAAAAAAAAAAAAAAAAAAAAAAAAAAAAAAA/AAAAAAAAAKCGAQAAAAAAAAAAAAAAAAAMAAAAAQAAAAAAAAAAAAAAAAAAAB8AAABUAAAAAAAABQAAAAEAAAAAAAAAAAAAAAAAAAAAAAAAAAAAAAAAAAAAAAAAAAAAAAJ/f38AAAAAA8zMzADAwP8Af39/AAAAAAAAAAAAAAAAAAAAAAAAAAAAIQAAABgAAAAUAAAA5wQAAMMPAACROAAAfyQAABAAAAAmAAAACAAAAD2wAAAAAAAA"/>
               </a:ext>
             </a:extLst>
           </p:cNvSpPr>
@@ -2410,7 +2410,7 @@
             <a:spLocks noGrp="1" noChangeArrowheads="1"/>
             <a:extLst>
               <a:ext uri="smNativeData">
-                <pr:smNativeData xmlns:pr="smNativeData" xmlns="smNativeData" val="SMDATA_15_9kV5ZhMAAAAlAAAAZAAAAA0AAAAAkAAAAJAAAACQAAAAkAAAAAAAAAAAAAAAAAAAAAEAAABQAAAAAAAAAAAA4D8AAAAAAADgPwAAAAAAAOA/AAAAAAAA4D8AAAAAAADgPwAAAAAAAOA/AAAAAAAA4D8AAAAAAADgPwAAAAAAAOA/AAAAAAAA4D8CAAAAjAAAAAAAAAAAAAAAQoX0DP///wgAAAAAAAAAAAAAAAAAAAAAAAAAAAAAAAAAAAAAZAAAAAEAAABAAAAAAAAAAAAAAAAAAAAAAAAAAAAAAAAAAAAAAAAAAAAAAAAAAAAAAAAAAAAAAAAAAAAAAAAAAAAAAAAAAAAAAAAAAAAAAAAAAAAAAAAAAAAAAAAAAAAAFAAAADwAAAAAAAAAAAAAAAAAAAkUAAAAAQAAABQAAAAUAAAAFAAAAAEAAAAAAAAAZAAAAGQAAAAAAAAAZAAAAGQAAAAVAAAAYAAAAAAAAAAAAAAADwAAACADAAAAAAAAAAAAAAEAAACgMgAAVgcAAKr4//8BAAAAf39/AAEAAABkAAAAAAAAABQAAABAHwAAAAAAACYAAAAAAAAAwOD//wAAAAAmAAAAZAAAABYAAABMAAAAAAAAAAAAAAAEAAAAAAAAAAEAAABZWVkKAAAAACgAAAAoAAAAZAAAAGQAAAAAAAAAzMzMAAAAAABQAAAAUAAAAGQAAABkAAAAAAAAABcAAAAUAAAAAAAAAAAAAAD/fwAA/38AAAAAAAAJAAAABAAAAAAAAAAeAAAAaAAAAAAAAAAAAAAAAAAAAAAAAAAAAAAAECcAABAnAAAAAAAAAAAAAAAAAAAAAAAAAAAAAAAAAAAAAAAAAAAAABQAAAAAAAAAwMD/AAAAAABkAAAAMgAAAAAAAABkAAAAAAAAAH9/fwAKAAAAIgAAABgAAAAAAAAAAAAAAAAAAAAAAAAAAAAAAAAAAAAkAAAAJAAAAAAAAAAHAAAAAAAAAAAAAAAAAAAAAAAAAAAAAAAAAAAAf39/ACUAAABYAAAAAAAAAAAAAAAAAAAAAAAAAAAAAAAAAAAAAAAAAAAAAAAAAAAAAAAAAAAAAAA/AAAAAAAAAKCGAQAAAAAAAAAAAAAAAAAMAAAAAQAAAAAAAAAAAAAAAAAAAB8AAABUAAAAAAAABQAAAAEAAAAAAAAAAAAAAAAAAAAAAAAAAAAAAAAAAAAAAAAAAAAAAAJ/f38AAAAAA8zMzADAwP8Af39/AAAAAAAAAAAAAAAAAAAAAAAAAAAAIQAAABgAAAAUAAAAFAMAALYCAAB/NwAAvwoAABAAAAAmAAAACAAAADywAAAAAAAA"/>
+                <pr:smNativeData xmlns:pr="smNativeData" xmlns="smNativeData" val="SMDATA_15_bQt8ZhMAAAAlAAAAZAAAAA0AAAAAkAAAAJAAAACQAAAAkAAAAAAAAAAAAAAAAAAAAAEAAABQAAAAAAAAAAAA4D8AAAAAAADgPwAAAAAAAOA/AAAAAAAA4D8AAAAAAADgPwAAAAAAAOA/AAAAAAAA4D8AAAAAAADgPwAAAAAAAOA/AAAAAAAA4D8CAAAAjAAAAAAAAAAAAAAAQoX0DP///wgAAAAAAAAAAAAAAAAAAAAAAAAAAAAAAAAAAAAAZAAAAAEAAABAAAAAAAAAAAAAAAAAAAAAAAAAAAAAAAAAAAAAAAAAAAAAAAAAAAAAAAAAAAAAAAAAAAAAAAAAAAAAAAAAAAAAAAAAAAAAAAAAAAAAAAAAAAAAAAAAAAAAFAAAADwAAAAAAAAAAAAAAAAAAAkUAAAAAQAAABQAAAAUAAAAFAAAAAEAAAAAAAAAZAAAAGQAAAAAAAAAZAAAAGQAAAAVAAAAYAAAAAAAAAAAAAAADwAAACADAAAAAAAAAAAAAAEAAACgMgAAVgcAAKr4//8BAAAAf39/AAEAAABkAAAAAAAAABQAAABAHwAAAAAAACYAAAAAAAAAwOD//wAAAAAmAAAAZAAAABYAAABMAAAAAAAAAAAAAAAEAAAAAAAAAAEAAABZWVkKAAAAACgAAAAoAAAAZAAAAGQAAAAAAAAAzMzMAAAAAABQAAAAUAAAAGQAAABkAAAAAAAAABcAAAAUAAAAAAAAAAAAAAD/fwAA/38AAAAAAAAJAAAABAAAAAAAAAAeAAAAaAAAAAAAAAAAAAAAAAAAAAAAAAAAAAAAECcAABAnAAAAAAAAAAAAAAAAAAAAAAAAAAAAAAAAAAAAAAAAAAAAABQAAAAAAAAAwMD/AAAAAABkAAAAMgAAAAAAAABkAAAAAAAAAH9/fwAKAAAAIgAAABgAAAAAAAAAAAAAAAAAAAAAAAAAAAAAAAAAAAAkAAAAJAAAAAAAAAAHAAAAAAAAAAAAAAAAAAAAAAAAAAAAAAAAAAAAf39/ACUAAABYAAAAAAAAAAAAAAAAAAAAAAAAAAAAAAAAAAAAAAAAAAAAAAAAAAAAAAAAAAAAAAA/AAAAAAAAAKCGAQAAAAAAAAAAAAAAAAAMAAAAAQAAAAAAAAAAAAAAAAAAAB8AAABUAAAAAAAABQAAAAEAAAAAAAAAAAAAAAAAAAAAAAAAAAAAAAAAAAAAAAAAAAAAAAJ/f38AAAAAA8zMzADAwP8Af39/AAAAAAAAAAAAAAAAAAAAAAAAAAAAIQAAABgAAAAUAAAAFAMAALYCAAB/NwAAvwoAABAAAAAmAAAACAAAADywAAAAAAAA"/>
               </a:ext>
             </a:extLst>
           </p:cNvSpPr>
@@ -2545,7 +2545,7 @@
             <a:spLocks noGrp="1" noChangeArrowheads="1"/>
             <a:extLst>
               <a:ext uri="smNativeData">
-                <pr:smNativeData xmlns:pr="smNativeData" xmlns="smNativeData" val="SMDATA_15_9kV5ZhMAAAAlAAAAZAAAAA0AAAAAkAAAAJAAAACQAAAAkAAAAAAAAAAAAAAAAAAAAAEAAABQAAAAAAAAAAAA4D8AAAAAAADgPwAAAAAAAOA/AAAAAAAA4D8AAAAAAADgPwAAAAAAAOA/AAAAAAAA4D8AAAAAAADgPwAAAAAAAOA/AAAAAAAA4D8CAAAAjAAAAAAAAAAAAAAAQoX0DP///wgAAAAAAAAAAAAAAAAAAAAAAAAAAAAAAAAAAAAAZAAAAAEAAABAAAAAAAAAAAAAAAAAAAAAAAAAAAAAAAAAAAAAAAAAAAAAAAAAAAAAAAAAAAAAAAAAAAAAAAAAAAAAAAAAAAAAAAAAAAAAAAAAAAAAAAAAAAAAAAAAAAAAFAAAADwAAAAAAAAAAAAAAAAAAAkUAAAAAQAAABQAAAAUAAAAFAAAAAEAAAAAAAAAZAAAAGQAAAAAAAAAZAAAAGQAAAAVAAAAYAAAAAAAAAAAAAAADwAAACADAAAAAAAAAAAAAAEAAACgMgAAVgcAAKr4//8BAAAAf39/AAEAAABkAAAAAAAAABQAAABAHwAAAAAAACYAAAAAAAAAwOD//wAAAAAmAAAAZAAAABYAAABMAAAAAAAAAAAAAAAEAAAAAAAAAAEAAABZWVkKAAAAACgAAAAoAAAAZAAAAGQAAAAAAAAAzMzMAAAAAABQAAAAUAAAAGQAAABkAAAAAAAAABcAAAAUAAAAAAAAAAAAAAD/fwAA/38AAAAAAAAJAAAABAAAAAAAAAAeAAAAaAAAAAAAAAAAAAAAAAAAAAAAAAAAAAAAECcAABAnAAAAAAAAAAAAAAAAAAAAAAAAAAAAAAAAAAAAAAAAAAAAABQAAAAAAAAAwMD/AAAAAABkAAAAMgAAAAAAAABkAAAAAAAAAH9/fwAKAAAAIgAAABgAAAAAAAAAAAAAAAAAAAAAAAAAAAAAAAAAAAAkAAAAJAAAAAAAAAAHAAAAAAAAAAAAAAAAAAAAAAAAAAAAAAAAAAAAf39/ACUAAABYAAAAAAAAAAAAAAAAAAAAAAAAAAAAAAAAAAAAAAAAAAAAAAAAAAAAAAAAAAAAAAA/AAAAAAAAAKCGAQAAAAAAAAAAAAAAAAAMAAAAAQAAAAAAAAAAAAAAAAAAAB8AAABUAAAAAAAABQAAAAEAAAAAAAAAAAAAAAAAAAAAAAAAAAAAAAAAAAAAAAAAAAAAAAJ/f38AAAAAA8zMzADAwP8Af39/AAAAAAAAAAAAAAAAAAAAAAAAAAAAIQAAABgAAAAUAAAAFAMAALYCAAB/NwAAvwoAABAAAAAmAAAACAAAADywAAAAAAAA"/>
+                <pr:smNativeData xmlns:pr="smNativeData" xmlns="smNativeData" val="SMDATA_15_bQt8ZhMAAAAlAAAAZAAAAA0AAAAAkAAAAJAAAACQAAAAkAAAAAAAAAAAAAAAAAAAAAEAAABQAAAAAAAAAAAA4D8AAAAAAADgPwAAAAAAAOA/AAAAAAAA4D8AAAAAAADgPwAAAAAAAOA/AAAAAAAA4D8AAAAAAADgPwAAAAAAAOA/AAAAAAAA4D8CAAAAjAAAAAAAAAAAAAAAQoX0DP///wgAAAAAAAAAAAAAAAAAAAAAAAAAAAAAAAAAAAAAZAAAAAEAAABAAAAAAAAAAAAAAAAAAAAAAAAAAAAAAAAAAAAAAAAAAAAAAAAAAAAAAAAAAAAAAAAAAAAAAAAAAAAAAAAAAAAAAAAAAAAAAAAAAAAAAAAAAAAAAAAAAAAAFAAAADwAAAAAAAAAAAAAAAAAAAkUAAAAAQAAABQAAAAUAAAAFAAAAAEAAAAAAAAAZAAAAGQAAAAAAAAAZAAAAGQAAAAVAAAAYAAAAAAAAAAAAAAADwAAACADAAAAAAAAAAAAAAEAAACgMgAAVgcAAKr4//8BAAAAf39/AAEAAABkAAAAAAAAABQAAABAHwAAAAAAACYAAAAAAAAAwOD//wAAAAAmAAAAZAAAABYAAABMAAAAAAAAAAAAAAAEAAAAAAAAAAEAAABZWVkKAAAAACgAAAAoAAAAZAAAAGQAAAAAAAAAzMzMAAAAAABQAAAAUAAAAGQAAABkAAAAAAAAABcAAAAUAAAAAAAAAAAAAAD/fwAA/38AAAAAAAAJAAAABAAAAAAAAAAeAAAAaAAAAAAAAAAAAAAAAAAAAAAAAAAAAAAAECcAABAnAAAAAAAAAAAAAAAAAAAAAAAAAAAAAAAAAAAAAAAAAAAAABQAAAAAAAAAwMD/AAAAAABkAAAAMgAAAAAAAABkAAAAAAAAAH9/fwAKAAAAIgAAABgAAAAAAAAAAAAAAAAAAAAAAAAAAAAAAAAAAAAkAAAAJAAAAAAAAAAHAAAAAAAAAAAAAAAAAAAAAAAAAAAAAAAAAAAAf39/ACUAAABYAAAAAAAAAAAAAAAAAAAAAAAAAAAAAAAAAAAAAAAAAAAAAAAAAAAAAAAAAAAAAAA/AAAAAAAAAKCGAQAAAAAAAAAAAAAAAAAMAAAAAQAAAAAAAAAAAAAAAAAAAB8AAABUAAAAAAAABQAAAAEAAAAAAAAAAAAAAAAAAAAAAAAAAAAAAAAAAAAAAAAAAAAAAAJ/f38AAAAAA8zMzADAwP8Af39/AAAAAAAAAAAAAAAAAAAAAAAAAAAAIQAAABgAAAAUAAAAFAMAALYCAAB/NwAAvwoAABAAAAAmAAAACAAAADywAAAAAAAA"/>
               </a:ext>
             </a:extLst>
           </p:cNvSpPr>
@@ -2654,7 +2654,7 @@
           <p:cNvSpPr>
             <a:extLst>
               <a:ext uri="smNativeData">
-                <pr:smNativeData xmlns:pr="smNativeData" xmlns="smNativeData" val="SMDATA_15_9kV5ZhMAAAAlAAAAZAAAAA0AAAAAkAAAAJAAAACQAAAAkAAAAAAAAAABAAAAAAAAAAEAAABQAAAAAAAAAAAA4D8AAAAAAADgPwAAAAAAAOA/AAAAAAAA4D8AAAAAAADgPwAAAAAAAOA/AAAAAAAA4D8AAAAAAADgPwAAAAAAAOA/AAAAAAAA4D8CAAAAjAAAAAEAAAAAAAAA+/v+AP///wgAAAAAAAAAAAAAAAAAAAAAAAAAAAAAAAAAAAAAeAAAAAEAAABAAAAAAAAAAAAAAABaAAAAAAAAAAAAAAAAAAAAAAAAAAAAAAAAAAAAAAAAAAAAAAAAAAAAAAAAAAAAAAAAAAAAAAAAAAAAAAAAAAAAAAAAAAAAAAAAAAAAFAAAADwAAAAAAAAAAAAAAAAAAAkUAAAAAQAAABQAAAAUAAAAFAAAAAEAAAAAAAAAZAAAAGQAAAAAAAAAZAAAAGQAAAAVAAAAYAAAAAAAAAAAAAAADwAAACADAAAAAAAAAAAAAAEAAACgMgAAVgcAAKr4//8BAAAAf39/AAEAAABkAAAAAAAAABQAAABAHwAAAAAAACYAAAAAAAAAwOD//wAAAAAmAAAAZAAAABYAAABMAAAAAAAAAAAAAAAEAAAAAAAAAAEAAABZWVkKAAAAACgAAAAoAAAAZAAAAGQAAAAAAAAAzMzMAAAAAABQAAAAUAAAAGQAAABkAAAAAAAAABcAAAAUAAAAAAAAAAAAAAD/fwAA/38AAAAAAAAJAAAABAAAAAAAAAAeAAAAaAAAAAAAAAAAAAAAAAAAAAAAAAAAAAAAECcAABAnAAAAAAAAAAAAAAAAAAAAAAAAAAAAAAAAAAAAAAAAAAAAABQAAAAAAAAAwMD/AAAAAABkAAAAMgAAAAAAAABkAAAAAAAAAH9/fwAKAAAAIgAAABgAAAAAAAAAAAAAAAAAAAAAAAAAAAAAAAAAAAAkAAAAJAAAAAAAAAAHAAAAAAAAAAAAAAAAAAAAAAAAAAAAAAAAAAAAf39/ACUAAABYAAAAAAAAAAAAAAAAAAAAAAAAAAAAAAAAAAAAAAAAAAAAAAAAAAAAAAAAAAAAAAA/AAAAAAAAAKCGAQAAAAAAAAAAAAAAAAAMAAAAAQAAAAAAAAAAAAAAAAAAAB8AAABUAAAA+/v+AP///wEAAAAAAAAAAAAAAAAAAAAAAAAAAAAAAAAAAAAAAAAAAAAAAAJ/f38AWVlZA8zMzADAwP8Af39/AAAAAAAAAAAAAAAAAAAAAAAAAAAAIQAAABgAAAAUAAAAuwMAAPIJAACQNAAALycAABAAAAAmAAAACAAAAP//////////"/>
+                <pr:smNativeData xmlns:pr="smNativeData" xmlns="smNativeData" val="SMDATA_15_bQt8ZhMAAAAlAAAAZAAAAA0AAAAAkAAAAJAAAACQAAAAkAAAAAAAAAABAAAAAAAAAAEAAABQAAAAAAAAAAAA4D8AAAAAAADgPwAAAAAAAOA/AAAAAAAA4D8AAAAAAADgPwAAAAAAAOA/AAAAAAAA4D8AAAAAAADgPwAAAAAAAOA/AAAAAAAA4D8CAAAAjAAAAAEAAAAAAAAA+/v+AP///wgAAAAAAAAAAAAAAAAAAAAAAAAAAAAAAAAAAAAAeAAAAAEAAABAAAAAAAAAAAAAAABaAAAAAAAAAAAAAAAAAAAAAAAAAAAAAAAAAAAAAAAAAAAAAAAAAAAAAAAAAAAAAAAAAAAAAAAAAAAAAAAAAAAAAAAAAAAAAAAAAAAAFAAAADwAAAAAAAAAAAAAAAAAAAkUAAAAAQAAABQAAAAUAAAAFAAAAAEAAAAAAAAAZAAAAGQAAAAAAAAAZAAAAGQAAAAVAAAAYAAAAAAAAAAAAAAADwAAACADAAAAAAAAAAAAAAEAAACgMgAAVgcAAKr4//8BAAAAf39/AAEAAABkAAAAAAAAABQAAABAHwAAAAAAACYAAAAAAAAAwOD//wAAAAAmAAAAZAAAABYAAABMAAAAAAAAAAAAAAAEAAAAAAAAAAEAAABZWVkKAAAAACgAAAAoAAAAZAAAAGQAAAAAAAAAzMzMAAAAAABQAAAAUAAAAGQAAABkAAAAAAAAABcAAAAUAAAAAAAAAAAAAAD/fwAA/38AAAAAAAAJAAAABAAAAAAAAAAeAAAAaAAAAAAAAAAAAAAAAAAAAAAAAAAAAAAAECcAABAnAAAAAAAAAAAAAAAAAAAAAAAAAAAAAAAAAAAAAAAAAAAAABQAAAAAAAAAwMD/AAAAAABkAAAAMgAAAAAAAABkAAAAAAAAAH9/fwAKAAAAIgAAABgAAAAAAAAAAAAAAAAAAAAAAAAAAAAAAAAAAAAkAAAAJAAAAAAAAAAHAAAAAAAAAAAAAAAAAAAAAAAAAAAAAAAAAAAAf39/ACUAAABYAAAAAAAAAAAAAAAAAAAAAAAAAAAAAAAAAAAAAAAAAAAAAAAAAAAAAAAAAAAAAAA/AAAAAAAAAKCGAQAAAAAAAAAAAAAAAAAMAAAAAQAAAAAAAAAAAAAAAAAAAB8AAABUAAAA+/v+AP///wEAAAAAAAAAAAAAAAAAAAAAAAAAAAAAAAAAAAAAAAAAAAAAAAJ/f38AWVlZA8zMzADAwP8Af39/AAAAAAAAAAAAAAAAAAAAAAAAAAAAIQAAABgAAAAUAAAAuwMAAPIJAACQNAAALycAABAAAAAmAAAACAAAAP//////////"/>
               </a:ext>
             </a:extLst>
           </p:cNvSpPr>
@@ -2699,7 +2699,7 @@
             <a:spLocks noGrp="1" noChangeArrowheads="1"/>
             <a:extLst>
               <a:ext uri="smNativeData">
-                <pr:smNativeData xmlns:pr="smNativeData" xmlns="smNativeData" val="SMDATA_15_9kV5ZhMAAAAlAAAAZAAAAA0AAAAAkAAAAJAAAACQAAAAkAAAAAAAAAAAAAAAAAAAAAEAAABQAAAAAAAAAAAA4D8AAAAAAADgPwAAAAAAAOA/AAAAAAAA4D8AAAAAAADgPwAAAAAAAOA/AAAAAAAA4D8AAAAAAADgPwAAAAAAAOA/AAAAAAAA4D8CAAAAjAAAAAAAAAAAAAAAQoX0DP///wgAAAAAAAAAAAAAAAAAAAAAAAAAAAAAAAAAAAAAZAAAAAEAAABAAAAAAAAAAAAAAAAAAAAAAAAAAAAAAAAAAAAAAAAAAAAAAAAAAAAAAAAAAAAAAAAAAAAAAAAAAAAAAAAAAAAAAAAAAAAAAAAAAAAAAAAAAAAAAAAAAAAAFAAAADwAAAAAAAAAAAAAAAAAAAkUAAAAAQAAABQAAAAUAAAAFAAAAAEAAAAAAAAAZAAAAGQAAAAAAAAAZAAAAGQAAAAVAAAAYAAAAAAAAAAAAAAADwAAACADAAAAAAAAAAAAAAEAAACgMgAAVgcAAKr4//8BAAAAf39/AAEAAABkAAAAAAAAABQAAABAHwAAAAAAACYAAAAAAAAAwOD//wAAAAAmAAAAZAAAABYAAABMAAAAAAAAAAAAAAAEAAAAAAAAAAEAAABZWVkKAAAAACgAAAAoAAAAZAAAAGQAAAAAAAAAzMzMAAAAAABQAAAAUAAAAGQAAABkAAAAAAAAABcAAAAUAAAAAAAAAAAAAAD/fwAA/38AAAAAAAAJAAAABAAAAAAAAAAeAAAAaAAAAAAAAAAAAAAAAAAAAAAAAAAAAAAAECcAABAnAAAAAAAAAAAAAAAAAAAAAAAAAAAAAAAAAAAAAAAAAAAAABQAAAAAAAAAwMD/AAAAAABkAAAAMgAAAAAAAABkAAAAAAAAAH9/fwAKAAAAIgAAABgAAAAAAAAAAAAAAAAAAAAAAAAAAAAAAAAAAAAkAAAAJAAAAAAAAAAHAAAAAAAAAAAAAAAAAAAAAAAAAAAAAAAAAAAAf39/ACUAAABYAAAAAAAAAAAAAAAAAAAAAAAAAAAAAAAAAAAAAAAAAAAAAAAAAAAAAAAAAAAAAAA/AAAAAAAAAKCGAQAAAAAAAAAAAAAAAAAMAAAAAQAAAAAAAAAAAAAAAAAAAB8AAABUAAAAAAAABQAAAAEAAAAAAAAAAAAAAAAAAAAAAAAAAAAAAAAAAAAAAAAAAAAAAAJ/f38AAAAAA8zMzADAwP8Af39/AAAAAAAAAAAAAAAAAAAAAAAAAAAAIQAAABgAAAAUAAAAfAQAANkKAAC5NQAAMCcAABAAAAAmAAAACAAAAD2wAAAAAAAA"/>
+                <pr:smNativeData xmlns:pr="smNativeData" xmlns="smNativeData" val="SMDATA_15_bQt8ZhMAAAAlAAAAZAAAAA0AAAAAkAAAAJAAAACQAAAAkAAAAAAAAAAAAAAAAAAAAAEAAABQAAAAAAAAAAAA4D8AAAAAAADgPwAAAAAAAOA/AAAAAAAA4D8AAAAAAADgPwAAAAAAAOA/AAAAAAAA4D8AAAAAAADgPwAAAAAAAOA/AAAAAAAA4D8CAAAAjAAAAAAAAAAAAAAAQoX0DP///wgAAAAAAAAAAAAAAAAAAAAAAAAAAAAAAAAAAAAAZAAAAAEAAABAAAAAAAAAAAAAAAAAAAAAAAAAAAAAAAAAAAAAAAAAAAAAAAAAAAAAAAAAAAAAAAAAAAAAAAAAAAAAAAAAAAAAAAAAAAAAAAAAAAAAAAAAAAAAAAAAAAAAFAAAADwAAAAAAAAAAAAAAAAAAAkUAAAAAQAAABQAAAAUAAAAFAAAAAEAAAAAAAAAZAAAAGQAAAAAAAAAZAAAAGQAAAAVAAAAYAAAAAAAAAAAAAAADwAAACADAAAAAAAAAAAAAAEAAACgMgAAVgcAAKr4//8BAAAAf39/AAEAAABkAAAAAAAAABQAAABAHwAAAAAAACYAAAAAAAAAwOD//wAAAAAmAAAAZAAAABYAAABMAAAAAAAAAAAAAAAEAAAAAAAAAAEAAABZWVkKAAAAACgAAAAoAAAAZAAAAGQAAAAAAAAAzMzMAAAAAABQAAAAUAAAAGQAAABkAAAAAAAAABcAAAAUAAAAAAAAAAAAAAD/fwAA/38AAAAAAAAJAAAABAAAAAAAAAAeAAAAaAAAAAAAAAAAAAAAAAAAAAAAAAAAAAAAECcAABAnAAAAAAAAAAAAAAAAAAAAAAAAAAAAAAAAAAAAAAAAAAAAABQAAAAAAAAAwMD/AAAAAABkAAAAMgAAAAAAAABkAAAAAAAAAH9/fwAKAAAAIgAAABgAAAAAAAAAAAAAAAAAAAAAAAAAAAAAAAAAAAAkAAAAJAAAAAAAAAAHAAAAAAAAAAAAAAAAAAAAAAAAAAAAAAAAAAAAf39/ACUAAABYAAAAAAAAAAAAAAAAAAAAAAAAAAAAAAAAAAAAAAAAAAAAAAAAAAAAAAAAAAAAAAA/AAAAAAAAAKCGAQAAAAAAAAAAAAAAAAAMAAAAAQAAAAAAAAAAAAAAAAAAAB8AAABUAAAAAAAABQAAAAEAAAAAAAAAAAAAAAAAAAAAAAAAAAAAAAAAAAAAAAAAAAAAAAJ/f38AAAAAA8zMzADAwP8Af39/AAAAAAAAAAAAAAAAAAAAAAAAAAAAIQAAABgAAAAUAAAAfAQAANkKAAC5NQAAMCcAABAAAAAmAAAACAAAAD2wAAAAAAAA"/>
               </a:ext>
             </a:extLst>
           </p:cNvSpPr>
@@ -2879,7 +2879,7 @@
             <a:spLocks noGrp="1" noChangeArrowheads="1"/>
             <a:extLst>
               <a:ext uri="smNativeData">
-                <pr:smNativeData xmlns:pr="smNativeData" xmlns="smNativeData" val="SMDATA_15_9kV5ZhMAAAAlAAAAZAAAAA0AAAAAkAAAAJAAAACQAAAAkAAAAAAAAAAAAAAAAAAAAAEAAABQAAAAAAAAAAAA4D8AAAAAAADgPwAAAAAAAOA/AAAAAAAA4D8AAAAAAADgPwAAAAAAAOA/AAAAAAAA4D8AAAAAAADgPwAAAAAAAOA/AAAAAAAA4D8CAAAAjAAAAAAAAAAAAAAAQoX0DP///wgAAAAAAAAAAAAAAAAAAAAAAAAAAAAAAAAAAAAAZAAAAAEAAABAAAAAAAAAAAAAAAAAAAAAAAAAAAAAAAAAAAAAAAAAAAAAAAAAAAAAAAAAAAAAAAAAAAAAAAAAAAAAAAAAAAAAAAAAAAAAAAAAAAAAAAAAAAAAAAAAAAAAFAAAADwAAAAAAAAAAAAAAAAAAAkUAAAAAQAAABQAAAAUAAAAFAAAAAEAAAAAAAAAZAAAAGQAAAAAAAAAZAAAAGQAAAAVAAAAYAAAAAAAAAAAAAAADwAAACADAAAAAAAAAAAAAAEAAACgMgAAVgcAAKr4//8BAAAAf39/AAEAAABkAAAAAAAAABQAAABAHwAAAAAAACYAAAAAAAAAwOD//wAAAAAmAAAAZAAAABYAAABMAAAAAAAAAAAAAAAEAAAAAAAAAAEAAABZWVkKAAAAACgAAAAoAAAAZAAAAGQAAAAAAAAAzMzMAAAAAABQAAAAUAAAAGQAAABkAAAAAAAAABcAAAAUAAAAAAAAAAAAAAD/fwAA/38AAAAAAAAJAAAABAAAAAAAAAAeAAAAaAAAAAAAAAAAAAAAAAAAAAAAAAAAAAAAECcAABAnAAAAAAAAAAAAAAAAAAAAAAAAAAAAAAAAAAAAAAAAAAAAABQAAAAAAAAAwMD/AAAAAABkAAAAMgAAAAAAAABkAAAAAAAAAH9/fwAKAAAAIgAAABgAAAAAAAAAAAAAAAAAAAAAAAAAAAAAAAAAAAAkAAAAJAAAAAAAAAAHAAAAAAAAAAAAAAAAAAAAAAAAAAAAAAAAAAAAf39/ACUAAABYAAAAAAAAAAAAAAAAAAAAAAAAAAAAAAAAAAAAAAAAAAAAAAAAAAAAAAAAAAAAAAA/AAAAAAAAAKCGAQAAAAAAAAAAAAAAAAAMAAAAAQAAAAAAAAAAAAAAAAAAAB8AAABUAAAAAAAABQAAAAEAAAAAAAAAAAAAAAAAAAAAAAAAAAAAAAAAAAAAAAAAAAAAAAJ/f38AAAAAA8zMzADAwP8Af39/AAAAAAAAAAAAAAAAAAAAAAAAAAAAIQAAABgAAAAUAAAAFAMAALYCAAB/NwAAvwoAABAAAAAmAAAACAAAADywAAAAAAAA"/>
+                <pr:smNativeData xmlns:pr="smNativeData" xmlns="smNativeData" val="SMDATA_15_bQt8ZhMAAAAlAAAAZAAAAA0AAAAAkAAAAJAAAACQAAAAkAAAAAAAAAAAAAAAAAAAAAEAAABQAAAAAAAAAAAA4D8AAAAAAADgPwAAAAAAAOA/AAAAAAAA4D8AAAAAAADgPwAAAAAAAOA/AAAAAAAA4D8AAAAAAADgPwAAAAAAAOA/AAAAAAAA4D8CAAAAjAAAAAAAAAAAAAAAQoX0DP///wgAAAAAAAAAAAAAAAAAAAAAAAAAAAAAAAAAAAAAZAAAAAEAAABAAAAAAAAAAAAAAAAAAAAAAAAAAAAAAAAAAAAAAAAAAAAAAAAAAAAAAAAAAAAAAAAAAAAAAAAAAAAAAAAAAAAAAAAAAAAAAAAAAAAAAAAAAAAAAAAAAAAAFAAAADwAAAAAAAAAAAAAAAAAAAkUAAAAAQAAABQAAAAUAAAAFAAAAAEAAAAAAAAAZAAAAGQAAAAAAAAAZAAAAGQAAAAVAAAAYAAAAAAAAAAAAAAADwAAACADAAAAAAAAAAAAAAEAAACgMgAAVgcAAKr4//8BAAAAf39/AAEAAABkAAAAAAAAABQAAABAHwAAAAAAACYAAAAAAAAAwOD//wAAAAAmAAAAZAAAABYAAABMAAAAAAAAAAAAAAAEAAAAAAAAAAEAAABZWVkKAAAAACgAAAAoAAAAZAAAAGQAAAAAAAAAzMzMAAAAAABQAAAAUAAAAGQAAABkAAAAAAAAABcAAAAUAAAAAAAAAAAAAAD/fwAA/38AAAAAAAAJAAAABAAAAAAAAAAeAAAAaAAAAAAAAAAAAAAAAAAAAAAAAAAAAAAAECcAABAnAAAAAAAAAAAAAAAAAAAAAAAAAAAAAAAAAAAAAAAAAAAAABQAAAAAAAAAwMD/AAAAAABkAAAAMgAAAAAAAABkAAAAAAAAAH9/fwAKAAAAIgAAABgAAAAAAAAAAAAAAAAAAAAAAAAAAAAAAAAAAAAkAAAAJAAAAAAAAAAHAAAAAAAAAAAAAAAAAAAAAAAAAAAAAAAAAAAAf39/ACUAAABYAAAAAAAAAAAAAAAAAAAAAAAAAAAAAAAAAAAAAAAAAAAAAAAAAAAAAAAAAAAAAAA/AAAAAAAAAKCGAQAAAAAAAAAAAAAAAAAMAAAAAQAAAAAAAAAAAAAAAAAAAB8AAABUAAAAAAAABQAAAAEAAAAAAAAAAAAAAAAAAAAAAAAAAAAAAAAAAAAAAAAAAAAAAAJ/f38AAAAAA8zMzADAwP8Af39/AAAAAAAAAAAAAAAAAAAAAAAAAAAAIQAAABgAAAAUAAAAFAMAALYCAAB/NwAAvwoAABAAAAAmAAAACAAAADywAAAAAAAA"/>
               </a:ext>
             </a:extLst>
           </p:cNvSpPr>
@@ -2988,7 +2988,7 @@
           <p:cNvSpPr>
             <a:extLst>
               <a:ext uri="smNativeData">
-                <pr:smNativeData xmlns:pr="smNativeData" xmlns="smNativeData" val="SMDATA_15_9kV5ZhMAAAAlAAAAZAAAAA0AAAAAkAAAAJAAAACQAAAAkAAAAAAAAAABAAAAAAAAAAEAAABQAAAAAAAAAAAA4D8AAAAAAADgPwAAAAAAAOA/AAAAAAAA4D8AAAAAAADgPwAAAAAAAOA/AAAAAAAA4D8AAAAAAADgPwAAAAAAAOA/AAAAAAAA4D8CAAAAjAAAAAEAAAAAAAAAISEhDf///wgAAAAAAAAAAAAAAAAAAAAAAAAAAAAAAAAAAAAAeAAAAAEAAABAAAAAAAAAAAAAAABaAAAAAAAAAAAAAAAAAAAAAAAAAAAAAAAAAAAAAAAAAAAAAAAAAAAAAAAAAAAAAAAAAAAAAAAAAAAAAAAAAAAAAAAAAAAAAAAAAAAAFAAAADwAAAAAAAAAAAAAAAAAAAkUAAAAAQAAABQAAAAUAAAAFAAAAAEAAAAAAAAAZAAAAGQAAAAAAAAAZAAAAGQAAAAVAAAAYAAAAAAAAAAAAAAADwAAACADAAAAAAAAAAAAAAEAAACgMgAAVgcAAKr4//8BAAAAf39/AAEAAABkAAAAAAAAABQAAABAHwAAAAAAACYAAAAAAAAAwOD//wAAAAAmAAAAZAAAABYAAABMAAAAAAAAAAAAAAAEAAAAAAAAAAEAAABZWVkKAAAAACgAAAAoAAAAZAAAAGQAAAAAAAAAzMzMAAAAAABQAAAAUAAAAGQAAABkAAAAAAAAABcAAAAUAAAAAAAAAAAAAAD/fwAA/38AAAAAAAAJAAAABAAAAAAAAAAeAAAAaAAAAAAAAAAAAAAAAAAAAAAAAAAAAAAAECcAABAnAAAAAAAAAAAAAAAAAAAAAAAAAAAAAAAAAAAAAAAAAAAAABQAAAAAAAAAwMD/AAAAAABkAAAAMgAAAAAAAABkAAAAAAAAAH9/fwAKAAAAIgAAABgAAAAAAAAAAAAAAAAAAAAAAAAAAAAAAAAAAAAkAAAAJAAAAAAAAAAHAAAAAAAAAAAAAAAAAAAAAAAAAAAAAAAAAAAAf39/ACUAAABYAAAAAAAAAAAAAAAAAAAAAAAAAAAAAAAAAAAAAAAAAAAAAAAAAAAAAAAAAAAAAAA/AAAAAAAAAKCGAQAAAAAAAAAAAAAAAAAMAAAAAQAAAAAAAAAAAAAAAAAAAB8AAABUAAAAAAAABgAAAAEAAAAAAAAAAAAAAAAAAAAAAAAAAAAAAAAAAAAAAAAAAAAAAAJ/f38AAAAAA8zMzADAwP8Af39/AAAAAAAAAAAAAAAAAAAAAAAAAAAAIQAAABgAAAAUAAAAuwMAAPIJAACQNAAALycAABAAAAAmAAAACAAAAP//////////"/>
+                <pr:smNativeData xmlns:pr="smNativeData" xmlns="smNativeData" val="SMDATA_15_bQt8ZhMAAAAlAAAAZAAAAA0AAAAAkAAAAJAAAACQAAAAkAAAAAAAAAABAAAAAAAAAAEAAABQAAAAAAAAAAAA4D8AAAAAAADgPwAAAAAAAOA/AAAAAAAA4D8AAAAAAADgPwAAAAAAAOA/AAAAAAAA4D8AAAAAAADgPwAAAAAAAOA/AAAAAAAA4D8CAAAAjAAAAAEAAAAAAAAAISEhDf///wgAAAAAAAAAAAAAAAAAAAAAAAAAAAAAAAAAAAAAeAAAAAEAAABAAAAAAAAAAAAAAABaAAAAAAAAAAAAAAAAAAAAAAAAAAAAAAAAAAAAAAAAAAAAAAAAAAAAAAAAAAAAAAAAAAAAAAAAAAAAAAAAAAAAAAAAAAAAAAAAAAAAFAAAADwAAAAAAAAAAAAAAAAAAAkUAAAAAQAAABQAAAAUAAAAFAAAAAEAAAAAAAAAZAAAAGQAAAAAAAAAZAAAAGQAAAAVAAAAYAAAAAAAAAAAAAAADwAAACADAAAAAAAAAAAAAAEAAACgMgAAVgcAAKr4//8BAAAAf39/AAEAAABkAAAAAAAAABQAAABAHwAAAAAAACYAAAAAAAAAwOD//wAAAAAmAAAAZAAAABYAAABMAAAAAAAAAAAAAAAEAAAAAAAAAAEAAABZWVkKAAAAACgAAAAoAAAAZAAAAGQAAAAAAAAAzMzMAAAAAABQAAAAUAAAAGQAAABkAAAAAAAAABcAAAAUAAAAAAAAAAAAAAD/fwAA/38AAAAAAAAJAAAABAAAAAAAAAAeAAAAaAAAAAAAAAAAAAAAAAAAAAAAAAAAAAAAECcAABAnAAAAAAAAAAAAAAAAAAAAAAAAAAAAAAAAAAAAAAAAAAAAABQAAAAAAAAAwMD/AAAAAABkAAAAMgAAAAAAAABkAAAAAAAAAH9/fwAKAAAAIgAAABgAAAAAAAAAAAAAAAAAAAAAAAAAAAAAAAAAAAAkAAAAJAAAAAAAAAAHAAAAAAAAAAAAAAAAAAAAAAAAAAAAAAAAAAAAf39/ACUAAABYAAAAAAAAAAAAAAAAAAAAAAAAAAAAAAAAAAAAAAAAAAAAAAAAAAAAAAAAAAAAAAA/AAAAAAAAAKCGAQAAAAAAAAAAAAAAAAAMAAAAAQAAAAAAAAAAAAAAAAAAAB8AAABUAAAAAAAABgAAAAEAAAAAAAAAAAAAAAAAAAAAAAAAAAAAAAAAAAAAAAAAAAAAAAJ/f38AAAAAA8zMzADAwP8Af39/AAAAAAAAAAAAAAAAAAAAAAAAAAAAIQAAABgAAAAUAAAAuwMAAPIJAACQNAAALycAABAAAAAmAAAACAAAAP//////////"/>
               </a:ext>
             </a:extLst>
           </p:cNvSpPr>
@@ -3033,7 +3033,7 @@
             <a:spLocks noGrp="1" noChangeArrowheads="1"/>
             <a:extLst>
               <a:ext uri="smNativeData">
-                <pr:smNativeData xmlns:pr="smNativeData" xmlns="smNativeData" val="SMDATA_15_9kV5ZhMAAAAlAAAAZAAAAA0AAAAAkAAAAJAAAACQAAAAkAAAAAAAAAAAAAAAAAAAAAEAAABQAAAAAAAAAAAA4D8AAAAAAADgPwAAAAAAAOA/AAAAAAAA4D8AAAAAAADgPwAAAAAAAOA/AAAAAAAA4D8AAAAAAADgPwAAAAAAAOA/AAAAAAAA4D8CAAAAjAAAAAAAAAAAAAAAQoX0DP///wgAAAAAAAAAAAAAAAAAAAAAAAAAAAAAAAAAAAAAZAAAAAEAAABAAAAAAAAAAAAAAAAAAAAAAAAAAAAAAAAAAAAAAAAAAAAAAAAAAAAAAAAAAAAAAAAAAAAAAAAAAAAAAAAAAAAAAAAAAAAAAAAAAAAAAAAAAAAAAAAAAAAAFAAAADwAAAAAAAAAAAAAAAAAAAkUAAAAAQAAABQAAAAUAAAAFAAAAAEAAAAAAAAAZAAAAGQAAAAAAAAAZAAAAGQAAAAVAAAAYAAAAAAAAAAAAAAADwAAACADAAAAAAAAAAAAAAEAAACgMgAAVgcAAKr4//8BAAAAf39/AAEAAABkAAAAAAAAABQAAABAHwAAAAAAACYAAAAAAAAAwOD//wAAAAAmAAAAZAAAABYAAABMAAAAAAAAAAAAAAAEAAAAAAAAAAEAAABZWVkKAAAAACgAAAAoAAAAZAAAAGQAAAAAAAAAzMzMAAAAAABQAAAAUAAAAGQAAABkAAAAAAAAABcAAAAUAAAAAAAAAAAAAAD/fwAA/38AAAAAAAAJAAAABAAAAAAAAAAeAAAAaAAAAAAAAAAAAAAAAAAAAAAAAAAAAAAAECcAABAnAAAAAAAAAAAAAAAAAAAAAAAAAAAAAAAAAAAAAAAAAAAAABQAAAAAAAAAwMD/AAAAAABkAAAAMgAAAAAAAABkAAAAAAAAAH9/fwAKAAAAIgAAABgAAAAAAAAAAAAAAAAAAAAAAAAAAAAAAAAAAAAkAAAAJAAAAAAAAAAHAAAAAAAAAAAAAAAAAAAAAAAAAAAAAAAAAAAAf39/ACUAAABYAAAAAAAAAAAAAAAAAAAAAAAAAAAAAAAAAAAAAAAAAAAAAAAAAAAAAAAAAAAAAAA/AAAAAAAAAKCGAQAAAAAAAAAAAAAAAAAMAAAAAQAAAAAAAAAAAAAAAAAAAB8AAABUAAAAAAAABQAAAAEAAAAAAAAAAAAAAAAAAAAAAAAAAAAAAAAAAAAAAAAAAAAAAAJ/f38AAAAAA8zMzADAwP8Af39/AAAAAAAAAAAAAAAAAAAAAAAAAAAAIQAAABgAAAAUAAAAfAQAANkKAAC5NQAAMCcAABAAAAAmAAAACAAAAD2wAAAAAAAA"/>
+                <pr:smNativeData xmlns:pr="smNativeData" xmlns="smNativeData" val="SMDATA_15_bQt8ZhMAAAAlAAAAZAAAAA0AAAAAkAAAAJAAAACQAAAAkAAAAAAAAAAAAAAAAAAAAAEAAABQAAAAAAAAAAAA4D8AAAAAAADgPwAAAAAAAOA/AAAAAAAA4D8AAAAAAADgPwAAAAAAAOA/AAAAAAAA4D8AAAAAAADgPwAAAAAAAOA/AAAAAAAA4D8CAAAAjAAAAAAAAAAAAAAAQoX0DP///wgAAAAAAAAAAAAAAAAAAAAAAAAAAAAAAAAAAAAAZAAAAAEAAABAAAAAAAAAAAAAAAAAAAAAAAAAAAAAAAAAAAAAAAAAAAAAAAAAAAAAAAAAAAAAAAAAAAAAAAAAAAAAAAAAAAAAAAAAAAAAAAAAAAAAAAAAAAAAAAAAAAAAFAAAADwAAAAAAAAAAAAAAAAAAAkUAAAAAQAAABQAAAAUAAAAFAAAAAEAAAAAAAAAZAAAAGQAAAAAAAAAZAAAAGQAAAAVAAAAYAAAAAAAAAAAAAAADwAAACADAAAAAAAAAAAAAAEAAACgMgAAVgcAAKr4//8BAAAAf39/AAEAAABkAAAAAAAAABQAAABAHwAAAAAAACYAAAAAAAAAwOD//wAAAAAmAAAAZAAAABYAAABMAAAAAAAAAAAAAAAEAAAAAAAAAAEAAABZWVkKAAAAACgAAAAoAAAAZAAAAGQAAAAAAAAAzMzMAAAAAABQAAAAUAAAAGQAAABkAAAAAAAAABcAAAAUAAAAAAAAAAAAAAD/fwAA/38AAAAAAAAJAAAABAAAAAAAAAAeAAAAaAAAAAAAAAAAAAAAAAAAAAAAAAAAAAAAECcAABAnAAAAAAAAAAAAAAAAAAAAAAAAAAAAAAAAAAAAAAAAAAAAABQAAAAAAAAAwMD/AAAAAABkAAAAMgAAAAAAAABkAAAAAAAAAH9/fwAKAAAAIgAAABgAAAAAAAAAAAAAAAAAAAAAAAAAAAAAAAAAAAAkAAAAJAAAAAAAAAAHAAAAAAAAAAAAAAAAAAAAAAAAAAAAAAAAAAAAf39/ACUAAABYAAAAAAAAAAAAAAAAAAAAAAAAAAAAAAAAAAAAAAAAAAAAAAAAAAAAAAAAAAAAAAA/AAAAAAAAAKCGAQAAAAAAAAAAAAAAAAAMAAAAAQAAAAAAAAAAAAAAAAAAAB8AAABUAAAAAAAABQAAAAEAAAAAAAAAAAAAAAAAAAAAAAAAAAAAAAAAAAAAAAAAAAAAAAJ/f38AAAAAA8zMzADAwP8Af39/AAAAAAAAAAAAAAAAAAAAAAAAAAAAIQAAABgAAAAUAAAAfAQAANkKAAC5NQAAMCcAABAAAAAmAAAACAAAAD2wAAAAAAAA"/>
               </a:ext>
             </a:extLst>
           </p:cNvSpPr>
@@ -3248,7 +3248,7 @@
             <a:spLocks noGrp="1" noChangeArrowheads="1"/>
             <a:extLst>
               <a:ext uri="smNativeData">
-                <pr:smNativeData xmlns:pr="smNativeData" xmlns="smNativeData" val="SMDATA_15_9kV5ZhMAAAAlAAAAZAAAAA0AAAAAkAAAAJAAAACQAAAAkAAAAAAAAAAAAAAAAAAAAAEAAABQAAAAAAAAAAAA4D8AAAAAAADgPwAAAAAAAOA/AAAAAAAA4D8AAAAAAADgPwAAAAAAAOA/AAAAAAAA4D8AAAAAAADgPwAAAAAAAOA/AAAAAAAA4D8CAAAAjAAAAAAAAAAAAAAAQoX0DP///wgAAAAAAAAAAAAAAAAAAAAAAAAAAAAAAAAAAAAAZAAAAAEAAABAAAAAAAAAAAAAAAAAAAAAAAAAAAAAAAAAAAAAAAAAAAAAAAAAAAAAAAAAAAAAAAAAAAAAAAAAAAAAAAAAAAAAAAAAAAAAAAAAAAAAAAAAAAAAAAAAAAAAFAAAADwAAAAAAAAAAAAAAAAAAAkUAAAAAQAAABQAAAAUAAAAFAAAAAEAAAAAAAAAZAAAAGQAAAAAAAAAZAAAAGQAAAAVAAAAYAAAAAAAAAAAAAAADwAAACADAAAAAAAAAAAAAAEAAACgMgAAVgcAAKr4//8BAAAAf39/AAEAAABkAAAAAAAAABQAAABAHwAAAAAAACYAAAAAAAAAwOD//wAAAAAmAAAAZAAAABYAAABMAAAAAAAAAAAAAAAEAAAAAAAAAAEAAABZWVkKAAAAACgAAAAoAAAAZAAAAGQAAAAAAAAAzMzMAAAAAABQAAAAUAAAAGQAAABkAAAAAAAAABcAAAAUAAAAAAAAAAAAAAD/fwAA/38AAAAAAAAJAAAABAAAAAAAAAAeAAAAaAAAAAAAAAAAAAAAAAAAAAAAAAAAAAAAECcAABAnAAAAAAAAAAAAAAAAAAAAAAAAAAAAAAAAAAAAAAAAAAAAABQAAAAAAAAAwMD/AAAAAABkAAAAMgAAAAAAAABkAAAAAAAAAH9/fwAKAAAAIgAAABgAAAAAAAAAAAAAAAAAAAAAAAAAAAAAAAAAAAAkAAAAJAAAAAAAAAAHAAAAAAAAAAAAAAAAAAAAAAAAAAAAAAAAAAAAf39/ACUAAABYAAAAAAAAAAAAAAAAAAAAAAAAAAAAAAAAAAAAAAAAAAAAAAAAAAAAAAAAAAAAAAA/AAAAAAAAAKCGAQAAAAAAAAAAAAAAAAAMAAAAAQAAAAAAAAAAAAAAAAAAAB8AAABUAAAAAAAABQAAAAEAAAAAAAAAAAAAAAAAAAAAAAAAAAAAAAAAAAAAAAAAAAAAAAJ/f38AAAAAA8zMzADAwP8Af39/AAAAAAAAAAAAAAAAAAAAAAAAAAAAIQAAABgAAAAUAAAAFAMAALYCAAB/NwAAvwoAABAAAAAmAAAACAAAADywAAAAAAAA"/>
+                <pr:smNativeData xmlns:pr="smNativeData" xmlns="smNativeData" val="SMDATA_15_bQt8ZhMAAAAlAAAAZAAAAA0AAAAAkAAAAJAAAACQAAAAkAAAAAAAAAAAAAAAAAAAAAEAAABQAAAAAAAAAAAA4D8AAAAAAADgPwAAAAAAAOA/AAAAAAAA4D8AAAAAAADgPwAAAAAAAOA/AAAAAAAA4D8AAAAAAADgPwAAAAAAAOA/AAAAAAAA4D8CAAAAjAAAAAAAAAAAAAAAQoX0DP///wgAAAAAAAAAAAAAAAAAAAAAAAAAAAAAAAAAAAAAZAAAAAEAAABAAAAAAAAAAAAAAAAAAAAAAAAAAAAAAAAAAAAAAAAAAAAAAAAAAAAAAAAAAAAAAAAAAAAAAAAAAAAAAAAAAAAAAAAAAAAAAAAAAAAAAAAAAAAAAAAAAAAAFAAAADwAAAAAAAAAAAAAAAAAAAkUAAAAAQAAABQAAAAUAAAAFAAAAAEAAAAAAAAAZAAAAGQAAAAAAAAAZAAAAGQAAAAVAAAAYAAAAAAAAAAAAAAADwAAACADAAAAAAAAAAAAAAEAAACgMgAAVgcAAKr4//8BAAAAf39/AAEAAABkAAAAAAAAABQAAABAHwAAAAAAACYAAAAAAAAAwOD//wAAAAAmAAAAZAAAABYAAABMAAAAAAAAAAAAAAAEAAAAAAAAAAEAAABZWVkKAAAAACgAAAAoAAAAZAAAAGQAAAAAAAAAzMzMAAAAAABQAAAAUAAAAGQAAABkAAAAAAAAABcAAAAUAAAAAAAAAAAAAAD/fwAA/38AAAAAAAAJAAAABAAAAAAAAAAeAAAAaAAAAAAAAAAAAAAAAAAAAAAAAAAAAAAAECcAABAnAAAAAAAAAAAAAAAAAAAAAAAAAAAAAAAAAAAAAAAAAAAAABQAAAAAAAAAwMD/AAAAAABkAAAAMgAAAAAAAABkAAAAAAAAAH9/fwAKAAAAIgAAABgAAAAAAAAAAAAAAAAAAAAAAAAAAAAAAAAAAAAkAAAAJAAAAAAAAAAHAAAAAAAAAAAAAAAAAAAAAAAAAAAAAAAAAAAAf39/ACUAAABYAAAAAAAAAAAAAAAAAAAAAAAAAAAAAAAAAAAAAAAAAAAAAAAAAAAAAAAAAAAAAAA/AAAAAAAAAKCGAQAAAAAAAAAAAAAAAAAMAAAAAQAAAAAAAAAAAAAAAAAAAB8AAABUAAAAAAAABQAAAAEAAAAAAAAAAAAAAAAAAAAAAAAAAAAAAAAAAAAAAAAAAAAAAAJ/f38AAAAAA8zMzADAwP8Af39/AAAAAAAAAAAAAAAAAAAAAAAAAAAAIQAAABgAAAAUAAAAFAMAALYCAAB/NwAAvwoAABAAAAAmAAAACAAAADywAAAAAAAA"/>
               </a:ext>
             </a:extLst>
           </p:cNvSpPr>
@@ -3357,7 +3357,7 @@
           <p:cNvSpPr>
             <a:extLst>
               <a:ext uri="smNativeData">
-                <pr:smNativeData xmlns:pr="smNativeData" xmlns="smNativeData" val="SMDATA_15_9kV5ZhMAAAAlAAAAZAAAAA0AAAAAkAAAAJAAAACQAAAAkAAAAAAAAAABAAAAAAAAAAEAAABQAAAAAAAAAAAA4D8AAAAAAADgPwAAAAAAAOA/AAAAAAAA4D8AAAAAAADgPwAAAAAAAOA/AAAAAAAA4D8AAAAAAADgPwAAAAAAAOA/AAAAAAAA4D8CAAAAjAAAAAEAAAAAAAAA+/v+AP///wgAAAAAAAAAAAAAAAAAAAAAAAAAAAAAAAAAAAAAeAAAAAEAAABAAAAAAAAAAAAAAABaAAAAAAAAAAAAAAAAAAAAAAAAAAAAAAAAAAAAAAAAAAAAAAAAAAAAAAAAAAAAAAAAAAAAAAAAAAAAAAAAAAAAAAAAAAAAAAAAAAAAFAAAADwAAAAAAAAAAAAAAAAAAAkUAAAAAQAAABQAAAAUAAAAFAAAAAEAAAAAAAAAZAAAAGQAAAAAAAAAZAAAAGQAAAAVAAAAYAAAAAAAAAAAAAAADwAAACADAAAAAAAAAAAAAAEAAACgMgAAVgcAAKr4//8BAAAAf39/AAEAAABkAAAAAAAAABQAAABAHwAAAAAAACYAAAAAAAAAwOD//wAAAAAmAAAAZAAAABYAAABMAAAAAAAAAAAAAAAEAAAAAAAAAAEAAABZWVkKAAAAACgAAAAoAAAAZAAAAGQAAAAAAAAAzMzMAAAAAABQAAAAUAAAAGQAAABkAAAAAAAAABcAAAAUAAAAAAAAAAAAAAD/fwAA/38AAAAAAAAJAAAABAAAAAAAAAAeAAAAaAAAAAAAAAAAAAAAAAAAAAAAAAAAAAAAECcAABAnAAAAAAAAAAAAAAAAAAAAAAAAAAAAAAAAAAAAAAAAAAAAABQAAAAAAAAAwMD/AAAAAABkAAAAMgAAAAAAAABkAAAAAAAAAH9/fwAKAAAAIgAAABgAAAAAAAAAAAAAAAAAAAAAAAAAAAAAAAAAAAAkAAAAJAAAAAAAAAAHAAAAAAAAAAAAAAAAAAAAAAAAAAAAAAAAAAAAf39/ACUAAABYAAAAAAAAAAAAAAAAAAAAAAAAAAAAAAAAAAAAAAAAAAAAAAAAAAAAAAAAAAAAAAA/AAAAAAAAAKCGAQAAAAAAAAAAAAAAAAAMAAAAAQAAAAAAAAAAAAAAAAAAAB8AAABUAAAA+/v+AAAAAAEAAAAAAAAAAAAAAAAAAAAAAAAAAAAAAAAAAAAAAAAAAAAAAAJ/f38AAAAAA8zMzADAwP8Af39/AAAAAAAAAAAAAAAAAAAAAAAAAAAAIQAAABgAAAAUAAAAuwMAAJYRAACQNAAAzSUAABAAAAAmAAAACAAAAP//////////"/>
+                <pr:smNativeData xmlns:pr="smNativeData" xmlns="smNativeData" val="SMDATA_15_bQt8ZhMAAAAlAAAAZAAAAA0AAAAAkAAAAJAAAACQAAAAkAAAAAAAAAABAAAAAAAAAAEAAABQAAAAAAAAAAAA4D8AAAAAAADgPwAAAAAAAOA/AAAAAAAA4D8AAAAAAADgPwAAAAAAAOA/AAAAAAAA4D8AAAAAAADgPwAAAAAAAOA/AAAAAAAA4D8CAAAAjAAAAAEAAAAAAAAA+/v+AP///wgAAAAAAAAAAAAAAAAAAAAAAAAAAAAAAAAAAAAAeAAAAAEAAABAAAAAAAAAAAAAAABaAAAAAAAAAAAAAAAAAAAAAAAAAAAAAAAAAAAAAAAAAAAAAAAAAAAAAAAAAAAAAAAAAAAAAAAAAAAAAAAAAAAAAAAAAAAAAAAAAAAAFAAAADwAAAAAAAAAAAAAAAAAAAkUAAAAAQAAABQAAAAUAAAAFAAAAAEAAAAAAAAAZAAAAGQAAAAAAAAAZAAAAGQAAAAVAAAAYAAAAAAAAAAAAAAADwAAACADAAAAAAAAAAAAAAEAAACgMgAAVgcAAKr4//8BAAAAf39/AAEAAABkAAAAAAAAABQAAABAHwAAAAAAACYAAAAAAAAAwOD//wAAAAAmAAAAZAAAABYAAABMAAAAAAAAAAAAAAAEAAAAAAAAAAEAAABZWVkKAAAAACgAAAAoAAAAZAAAAGQAAAAAAAAAzMzMAAAAAABQAAAAUAAAAGQAAABkAAAAAAAAABcAAAAUAAAAAAAAAAAAAAD/fwAA/38AAAAAAAAJAAAABAAAAAAAAAAeAAAAaAAAAAAAAAAAAAAAAAAAAAAAAAAAAAAAECcAABAnAAAAAAAAAAAAAAAAAAAAAAAAAAAAAAAAAAAAAAAAAAAAABQAAAAAAAAAwMD/AAAAAABkAAAAMgAAAAAAAABkAAAAAAAAAH9/fwAKAAAAIgAAABgAAAAAAAAAAAAAAAAAAAAAAAAAAAAAAAAAAAAkAAAAJAAAAAAAAAAHAAAAAAAAAAAAAAAAAAAAAAAAAAAAAAAAAAAAf39/ACUAAABYAAAAAAAAAAAAAAAAAAAAAAAAAAAAAAAAAAAAAAAAAAAAAAAAAAAAAAAAAAAAAAA/AAAAAAAAAKCGAQAAAAAAAAAAAAAAAAAMAAAAAQAAAAAAAAAAAAAAAAAAAB8AAABUAAAA+/v+AAAAAAEAAAAAAAAAAAAAAAAAAAAAAAAAAAAAAAAAAAAAAAAAAAAAAAJ/f38AAAAAA8zMzADAwP8Af39/AAAAAAAAAAAAAAAAAAAAAAAAAAAAIQAAABgAAAAUAAAAuwMAAJYRAACQNAAAzSUAABAAAAAmAAAACAAAAP//////////"/>
               </a:ext>
             </a:extLst>
           </p:cNvSpPr>
@@ -3402,7 +3402,7 @@
             <a:spLocks noGrp="1" noChangeArrowheads="1"/>
             <a:extLst>
               <a:ext uri="smNativeData">
-                <pr:smNativeData xmlns:pr="smNativeData" xmlns="smNativeData" val="SMDATA_15_9kV5ZhMAAAAlAAAAZAAAAA0AAAAAkAAAAJAAAACQAAAAkAAAAAAAAAAAAAAAAAAAAAEAAABQAAAAAAAAAAAA4D8AAAAAAADgPwAAAAAAAOA/AAAAAAAA4D8AAAAAAADgPwAAAAAAAOA/AAAAAAAA4D8AAAAAAADgPwAAAAAAAOA/AAAAAAAA4D8CAAAAjAAAAAAAAAAAAAAAQoX0DP///wgAAAAAAAAAAAAAAAAAAAAAAAAAAAAAAAAAAAAAZAAAAAEAAABAAAAAAAAAAAAAAAAAAAAAAAAAAAAAAAAAAAAAAAAAAAAAAAAAAAAAAAAAAAAAAAAAAAAAAAAAAAAAAAAAAAAAAAAAAAAAAAAAAAAAAAAAAAAAAAAAAAAAFAAAADwAAAAAAAAAAAAAAAAAAAkUAAAAAQAAABQAAAAUAAAAFAAAAAEAAAAAAAAAZAAAAGQAAAAAAAAAZAAAAGQAAAAVAAAAYAAAAAAAAAAAAAAADwAAACADAAAAAAAAAAAAAAEAAACgMgAAVgcAAKr4//8BAAAAf39/AAEAAABkAAAAAAAAABQAAABAHwAAAAAAACYAAAAAAAAAwOD//wAAAAAmAAAAZAAAABYAAABMAAAAAAAAAAAAAAAEAAAAAAAAAAEAAABZWVkKAAAAACgAAAAoAAAAZAAAAGQAAAAAAAAAzMzMAAAAAABQAAAAUAAAAGQAAABkAAAAAAAAABcAAAAUAAAAAAAAAAAAAAD/fwAA/38AAAAAAAAJAAAABAAAAAAAAAAeAAAAaAAAAAAAAAAAAAAAAAAAAAAAAAAAAAAAECcAABAnAAAAAAAAAAAAAAAAAAAAAAAAAAAAAAAAAAAAAAAAAAAAABQAAAAAAAAAwMD/AAAAAABkAAAAMgAAAAAAAABkAAAAAAAAAH9/fwAKAAAAIgAAABgAAAAAAAAAAAAAAAAAAAAAAAAAAAAAAAAAAAAkAAAAJAAAAAAAAAAHAAAAAAAAAAAAAAAAAAAAAAAAAAAAAAAAAAAAf39/ACUAAABYAAAAAAAAAAAAAAAAAAAAAAAAAAAAAAAAAAAAAAAAAAAAAAAAAAAAAAAAAAAAAAA/AAAAAAAAAKCGAQAAAAAAAAAAAAAAAAAMAAAAAQAAAAAAAAAAAAAAAAAAAB8AAABUAAAAAAAABQAAAAEAAAAAAAAAAAAAAAAAAAAAAAAAAAAAAAAAAAAAAAAAAAAAAAJ/f38AAAAAA8zMzADAwP8Af39/AAAAAAAAAAAAAAAAAAAAAAAAAAAAIQAAABgAAAAUAAAAfAQAAIESAAC5NQAAuCYAABAAAAAmAAAACAAAAD2wAAAAAAAA"/>
+                <pr:smNativeData xmlns:pr="smNativeData" xmlns="smNativeData" val="SMDATA_15_bQt8ZhMAAAAlAAAAZAAAAA0AAAAAkAAAAJAAAACQAAAAkAAAAAAAAAAAAAAAAAAAAAEAAABQAAAAAAAAAAAA4D8AAAAAAADgPwAAAAAAAOA/AAAAAAAA4D8AAAAAAADgPwAAAAAAAOA/AAAAAAAA4D8AAAAAAADgPwAAAAAAAOA/AAAAAAAA4D8CAAAAjAAAAAAAAAAAAAAAQoX0DP///wgAAAAAAAAAAAAAAAAAAAAAAAAAAAAAAAAAAAAAZAAAAAEAAABAAAAAAAAAAAAAAAAAAAAAAAAAAAAAAAAAAAAAAAAAAAAAAAAAAAAAAAAAAAAAAAAAAAAAAAAAAAAAAAAAAAAAAAAAAAAAAAAAAAAAAAAAAAAAAAAAAAAAFAAAADwAAAAAAAAAAAAAAAAAAAkUAAAAAQAAABQAAAAUAAAAFAAAAAEAAAAAAAAAZAAAAGQAAAAAAAAAZAAAAGQAAAAVAAAAYAAAAAAAAAAAAAAADwAAACADAAAAAAAAAAAAAAEAAACgMgAAVgcAAKr4//8BAAAAf39/AAEAAABkAAAAAAAAABQAAABAHwAAAAAAACYAAAAAAAAAwOD//wAAAAAmAAAAZAAAABYAAABMAAAAAAAAAAAAAAAEAAAAAAAAAAEAAABZWVkKAAAAACgAAAAoAAAAZAAAAGQAAAAAAAAAzMzMAAAAAABQAAAAUAAAAGQAAABkAAAAAAAAABcAAAAUAAAAAAAAAAAAAAD/fwAA/38AAAAAAAAJAAAABAAAAAAAAAAeAAAAaAAAAAAAAAAAAAAAAAAAAAAAAAAAAAAAECcAABAnAAAAAAAAAAAAAAAAAAAAAAAAAAAAAAAAAAAAAAAAAAAAABQAAAAAAAAAwMD/AAAAAABkAAAAMgAAAAAAAABkAAAAAAAAAH9/fwAKAAAAIgAAABgAAAAAAAAAAAAAAAAAAAAAAAAAAAAAAAAAAAAkAAAAJAAAAAAAAAAHAAAAAAAAAAAAAAAAAAAAAAAAAAAAAAAAAAAAf39/ACUAAABYAAAAAAAAAAAAAAAAAAAAAAAAAAAAAAAAAAAAAAAAAAAAAAAAAAAAAAAAAAAAAAA/AAAAAAAAAKCGAQAAAAAAAAAAAAAAAAAMAAAAAQAAAAAAAAAAAAAAAAAAAB8AAABUAAAAAAAABQAAAAEAAAAAAAAAAAAAAAAAAAAAAAAAAAAAAAAAAAAAAAAAAAAAAAJ/f38AAAAAA8zMzADAwP8Af39/AAAAAAAAAAAAAAAAAAAAAAAAAAAAIQAAABgAAAAUAAAAfAQAAIESAAC5NQAAuCYAABAAAAAmAAAACAAAAD2wAAAAAAAA"/>
               </a:ext>
             </a:extLst>
           </p:cNvSpPr>
@@ -3585,7 +3585,7 @@
             <a:spLocks noGrp="1" noChangeArrowheads="1"/>
             <a:extLst>
               <a:ext uri="smNativeData">
-                <pr:smNativeData xmlns:pr="smNativeData" xmlns="smNativeData" val="SMDATA_15_9kV5ZhMAAAAlAAAAZAAAAA0AAAAAkAAAAJAAAACQAAAAkAAAAAAAAAAAAAAAAAAAAAEAAABQAAAAAAAAAAAA4D8AAAAAAADgPwAAAAAAAOA/AAAAAAAA4D8AAAAAAADgPwAAAAAAAOA/AAAAAAAA4D8AAAAAAADgPwAAAAAAAOA/AAAAAAAA4D8CAAAAjAAAAAAAAAAAAAAAQoX0DP///wgAAAAAAAAAAAAAAAAAAAAAAAAAAAAAAAAAAAAAZAAAAAEAAABAAAAAAAAAAAAAAAAAAAAAAAAAAAAAAAAAAAAAAAAAAAAAAAAAAAAAAAAAAAAAAAAAAAAAAAAAAAAAAAAAAAAAAAAAAAAAAAAAAAAAAAAAAAAAAAAAAAAAFAAAADwAAAAAAAAAAAAAAAAAAAkUAAAAAQAAABQAAAAUAAAAFAAAAAEAAAAAAAAAZAAAAGQAAAAAAAAAZAAAAGQAAAAVAAAAYAAAAAAAAAAAAAAADwAAACADAAAAAAAAAAAAAAEAAACgMgAAVgcAAKr4//8BAAAAf39/AAEAAABkAAAAAAAAABQAAABAHwAAAAAAACYAAAAAAAAAwOD//wAAAAAmAAAAZAAAABYAAABMAAAAAAAAAAAAAAAEAAAAAAAAAAEAAABZWVkKAAAAACgAAAAoAAAAZAAAAGQAAAAAAAAAzMzMAAAAAABQAAAAUAAAAGQAAABkAAAAAAAAABcAAAAUAAAAAAAAAAAAAAD/fwAA/38AAAAAAAAJAAAABAAAAAAAAAAeAAAAaAAAAAAAAAAAAAAAAAAAAAAAAAAAAAAAECcAABAnAAAAAAAAAAAAAAAAAAAAAAAAAAAAAAAAAAAAAAAAAAAAABQAAAAAAAAAwMD/AAAAAABkAAAAMgAAAAAAAABkAAAAAAAAAH9/fwAKAAAAIgAAABgAAAAAAAAAAAAAAAAAAAAAAAAAAAAAAAAAAAAkAAAAJAAAAAAAAAAHAAAAAAAAAAAAAAAAAAAAAAAAAAAAAAAAAAAAf39/ACUAAABYAAAAAAAAAAAAAAAAAAAAAAAAAAAAAAAAAAAAAAAAAAAAAAAAAAAAAAAAAAAAAAA/AAAAAAAAAKCGAQAAAAAAAAAAAAAAAAAMAAAAAQAAAAAAAAAAAAAAAAAAAB8AAABUAAAAAAAABQAAAAEAAAAAAAAAAAAAAAAAAAAAAAAAAAAAAAAAAAAAAAAAAAAAAAJ/f38AAAAAA8zMzADAwP8Af39/AAAAAAAAAAAAAAAAAAAAAAAAAAAAIQAAABgAAAAUAAAAQwMAAA4LAABBNQAAlhEAABAAAAAmAAAACAAAAD2wAAAAAAAA"/>
+                <pr:smNativeData xmlns:pr="smNativeData" xmlns="smNativeData" val="SMDATA_15_bQt8ZhMAAAAlAAAAZAAAAA0AAAAAkAAAAJAAAACQAAAAkAAAAAAAAAAAAAAAAAAAAAEAAABQAAAAAAAAAAAA4D8AAAAAAADgPwAAAAAAAOA/AAAAAAAA4D8AAAAAAADgPwAAAAAAAOA/AAAAAAAA4D8AAAAAAADgPwAAAAAAAOA/AAAAAAAA4D8CAAAAjAAAAAAAAAAAAAAAQoX0DP///wgAAAAAAAAAAAAAAAAAAAAAAAAAAAAAAAAAAAAAZAAAAAEAAABAAAAAAAAAAAAAAAAAAAAAAAAAAAAAAAAAAAAAAAAAAAAAAAAAAAAAAAAAAAAAAAAAAAAAAAAAAAAAAAAAAAAAAAAAAAAAAAAAAAAAAAAAAAAAAAAAAAAAFAAAADwAAAAAAAAAAAAAAAAAAAkUAAAAAQAAABQAAAAUAAAAFAAAAAEAAAAAAAAAZAAAAGQAAAAAAAAAZAAAAGQAAAAVAAAAYAAAAAAAAAAAAAAADwAAACADAAAAAAAAAAAAAAEAAACgMgAAVgcAAKr4//8BAAAAf39/AAEAAABkAAAAAAAAABQAAABAHwAAAAAAACYAAAAAAAAAwOD//wAAAAAmAAAAZAAAABYAAABMAAAAAAAAAAAAAAAEAAAAAAAAAAEAAABZWVkKAAAAACgAAAAoAAAAZAAAAGQAAAAAAAAAzMzMAAAAAABQAAAAUAAAAGQAAABkAAAAAAAAABcAAAAUAAAAAAAAAAAAAAD/fwAA/38AAAAAAAAJAAAABAAAAAAAAAAeAAAAaAAAAAAAAAAAAAAAAAAAAAAAAAAAAAAAECcAABAnAAAAAAAAAAAAAAAAAAAAAAAAAAAAAAAAAAAAAAAAAAAAABQAAAAAAAAAwMD/AAAAAABkAAAAMgAAAAAAAABkAAAAAAAAAH9/fwAKAAAAIgAAABgAAAAAAAAAAAAAAAAAAAAAAAAAAAAAAAAAAAAkAAAAJAAAAAAAAAAHAAAAAAAAAAAAAAAAAAAAAAAAAAAAAAAAAAAAf39/ACUAAABYAAAAAAAAAAAAAAAAAAAAAAAAAAAAAAAAAAAAAAAAAAAAAAAAAAAAAAAAAAAAAAA/AAAAAAAAAKCGAQAAAAAAAAAAAAAAAAAMAAAAAQAAAAAAAAAAAAAAAAAAAB8AAABUAAAAAAAABQAAAAEAAAAAAAAAAAAAAAAAAAAAAAAAAAAAAAAAAAAAAAAAAAAAAAJ/f38AAAAAA8zMzADAwP8Af39/AAAAAAAAAAAAAAAAAAAAAAAAAAAAIQAAABgAAAAUAAAAQwMAAA4LAABBNQAAlhEAABAAAAAmAAAACAAAAD2wAAAAAAAA"/>
               </a:ext>
             </a:extLst>
           </p:cNvSpPr>
@@ -3797,7 +3797,7 @@
             <a:spLocks noGrp="1" noChangeArrowheads="1"/>
             <a:extLst>
               <a:ext uri="smNativeData">
-                <pr:smNativeData xmlns:pr="smNativeData" xmlns="smNativeData" val="SMDATA_15_9kV5ZhMAAAAlAAAAZAAAAA0AAAAAkAAAAJAAAACQAAAAkAAAAAAAAAAAAAAAAAAAAAEAAABQAAAAAAAAAAAA4D8AAAAAAADgPwAAAAAAAOA/AAAAAAAA4D8AAAAAAADgPwAAAAAAAOA/AAAAAAAA4D8AAAAAAADgPwAAAAAAAOA/AAAAAAAA4D8CAAAAjAAAAAAAAAAAAAAAQoX0DP///wgAAAAAAAAAAAAAAAAAAAAAAAAAAAAAAAAAAAAAZAAAAAEAAABAAAAAAAAAAAAAAAAAAAAAAAAAAAAAAAAAAAAAAAAAAAAAAAAAAAAAAAAAAAAAAAAAAAAAAAAAAAAAAAAAAAAAAAAAAAAAAAAAAAAAAAAAAAAAAAAAAAAAFAAAADwAAAAAAAAAAAAAAAAAAAkUAAAAAQAAABQAAAAUAAAAFAAAAAEAAAAAAAAAZAAAAGQAAAAAAAAAZAAAAGQAAAAVAAAAYAAAAAAAAAAAAAAADwAAACADAAAAAAAAAAAAAAEAAACgMgAAVgcAAKr4//8BAAAAf39/AAEAAABkAAAAAAAAABQAAABAHwAAAAAAACYAAAAAAAAAwOD//wAAAAAmAAAAZAAAABYAAABMAAAAAAAAAAAAAAAEAAAAAAAAAAEAAABZWVkKAAAAACgAAAAoAAAAZAAAAGQAAAAAAAAAzMzMAAAAAABQAAAAUAAAAGQAAABkAAAAAAAAABcAAAAUAAAAAAAAAAAAAAD/fwAA/38AAAAAAAAJAAAABAAAAAAAAAAeAAAAaAAAAAAAAAAAAAAAAAAAAAAAAAAAAAAAECcAABAnAAAAAAAAAAAAAAAAAAAAAAAAAAAAAAAAAAAAAAAAAAAAABQAAAAAAAAAwMD/AAAAAABkAAAAMgAAAAAAAABkAAAAAAAAAH9/fwAKAAAAIgAAABgAAAAAAAAAAAAAAAAAAAAAAAAAAAAAAAAAAAAkAAAAJAAAAAAAAAAHAAAAAAAAAAAAAAAAAAAAAAAAAAAAAAAAAAAAf39/ACUAAABYAAAAAAAAAAAAAAAAAAAAAAAAAAAAAAAAAAAAAAAAAAAAAAAAAAAAAAAAAAAAAAA/AAAAAAAAAKCGAQAAAAAAAAAAAAAAAAAMAAAAAQAAAAAAAAAAAAAAAAAAAB8AAABUAAAAAAAABQAAAAEAAAAAAAAAAAAAAAAAAAAAAAAAAAAAAAAAAAAAAAAAAAAAAAJ/f38AAAAAA8zMzADAwP8Af39/AAAAAAAAAAAAAAAAAAAAAAAAAAAAIQAAABgAAAAUAAAAFAMAALYCAAB/NwAAvwoAABAAAAAmAAAACAAAADywAAAAAAAA"/>
+                <pr:smNativeData xmlns:pr="smNativeData" xmlns="smNativeData" val="SMDATA_15_bQt8ZhMAAAAlAAAAZAAAAA0AAAAAkAAAAJAAAACQAAAAkAAAAAAAAAAAAAAAAAAAAAEAAABQAAAAAAAAAAAA4D8AAAAAAADgPwAAAAAAAOA/AAAAAAAA4D8AAAAAAADgPwAAAAAAAOA/AAAAAAAA4D8AAAAAAADgPwAAAAAAAOA/AAAAAAAA4D8CAAAAjAAAAAAAAAAAAAAAQoX0DP///wgAAAAAAAAAAAAAAAAAAAAAAAAAAAAAAAAAAAAAZAAAAAEAAABAAAAAAAAAAAAAAAAAAAAAAAAAAAAAAAAAAAAAAAAAAAAAAAAAAAAAAAAAAAAAAAAAAAAAAAAAAAAAAAAAAAAAAAAAAAAAAAAAAAAAAAAAAAAAAAAAAAAAFAAAADwAAAAAAAAAAAAAAAAAAAkUAAAAAQAAABQAAAAUAAAAFAAAAAEAAAAAAAAAZAAAAGQAAAAAAAAAZAAAAGQAAAAVAAAAYAAAAAAAAAAAAAAADwAAACADAAAAAAAAAAAAAAEAAACgMgAAVgcAAKr4//8BAAAAf39/AAEAAABkAAAAAAAAABQAAABAHwAAAAAAACYAAAAAAAAAwOD//wAAAAAmAAAAZAAAABYAAABMAAAAAAAAAAAAAAAEAAAAAAAAAAEAAABZWVkKAAAAACgAAAAoAAAAZAAAAGQAAAAAAAAAzMzMAAAAAABQAAAAUAAAAGQAAABkAAAAAAAAABcAAAAUAAAAAAAAAAAAAAD/fwAA/38AAAAAAAAJAAAABAAAAAAAAAAeAAAAaAAAAAAAAAAAAAAAAAAAAAAAAAAAAAAAECcAABAnAAAAAAAAAAAAAAAAAAAAAAAAAAAAAAAAAAAAAAAAAAAAABQAAAAAAAAAwMD/AAAAAABkAAAAMgAAAAAAAABkAAAAAAAAAH9/fwAKAAAAIgAAABgAAAAAAAAAAAAAAAAAAAAAAAAAAAAAAAAAAAAkAAAAJAAAAAAAAAAHAAAAAAAAAAAAAAAAAAAAAAAAAAAAAAAAAAAAf39/ACUAAABYAAAAAAAAAAAAAAAAAAAAAAAAAAAAAAAAAAAAAAAAAAAAAAAAAAAAAAAAAAAAAAA/AAAAAAAAAKCGAQAAAAAAAAAAAAAAAAAMAAAAAQAAAAAAAAAAAAAAAAAAAB8AAABUAAAAAAAABQAAAAEAAAAAAAAAAAAAAAAAAAAAAAAAAAAAAAAAAAAAAAAAAAAAAAJ/f38AAAAAA8zMzADAwP8Af39/AAAAAAAAAAAAAAAAAAAAAAAAAAAAIQAAABgAAAAUAAAAFAMAALYCAAB/NwAAvwoAABAAAAAmAAAACAAAADywAAAAAAAA"/>
               </a:ext>
             </a:extLst>
           </p:cNvSpPr>
@@ -3906,7 +3906,7 @@
           <p:cNvSpPr>
             <a:extLst>
               <a:ext uri="smNativeData">
-                <pr:smNativeData xmlns:pr="smNativeData" xmlns="smNativeData" val="SMDATA_15_9kV5ZhMAAAAlAAAAZAAAAA0AAAAAkAAAAJAAAACQAAAAkAAAAAAAAAABAAAAAAAAAAEAAABQAAAAAAAAAAAA4D8AAAAAAADgPwAAAAAAAOA/AAAAAAAA4D8AAAAAAADgPwAAAAAAAOA/AAAAAAAA4D8AAAAAAADgPwAAAAAAAOA/AAAAAAAA4D8CAAAAjAAAAAEAAAAAAAAA+/v+AP///wgAAAAAAAAAAAAAAAAAAAAAAAAAAAAAAAAAAAAAeAAAAAEAAABAAAAAAAAAAAAAAABaAAAAAAAAAAAAAAAAAAAAAAAAAAAAAAAAAAAAAAAAAAAAAAAAAAAAAAAAAAAAAAAAAAAAAAAAAAAAAAAAAAAAAAAAAAAAAAAAAAAAFAAAADwAAAAAAAAAAAAAAAAAAAkUAAAAAQAAABQAAAAUAAAAFAAAAAEAAAAAAAAAZAAAAGQAAAAAAAAAZAAAAGQAAAAVAAAAYAAAAAAAAAAAAAAADwAAACADAAAAAAAAAAAAAAEAAACgMgAAVgcAAKr4//8BAAAAf39/AAEAAABkAAAAAAAAABQAAABAHwAAAAAAACYAAAAAAAAAwOD//wAAAAAmAAAAZAAAABYAAABMAAAAAAAAAAAAAAAEAAAAAAAAAAEAAABZWVkKAAAAACgAAAAoAAAAZAAAAGQAAAAAAAAAzMzMAAAAAABQAAAAUAAAAGQAAABkAAAAAAAAABcAAAAUAAAAAAAAAAAAAAD/fwAA/38AAAAAAAAJAAAABAAAAAAAAAAeAAAAaAAAAAAAAAAAAAAAAAAAAAAAAAAAAAAAECcAABAnAAAAAAAAAAAAAAAAAAAAAAAAAAAAAAAAAAAAAAAAAAAAABQAAAAAAAAAwMD/AAAAAABkAAAAMgAAAAAAAABkAAAAAAAAAH9/fwAKAAAAIgAAABgAAAAAAAAAAAAAAAAAAAAAAAAAAAAAAAAAAAAkAAAAJAAAAAAAAAAHAAAAAAAAAAAAAAAAAAAAAAAAAAAAAAAAAAAAf39/ACUAAABYAAAAAAAAAAAAAAAAAAAAAAAAAAAAAAAAAAAAAAAAAAAAAAAAAAAAAAAAAAAAAAA/AAAAAAAAAKCGAQAAAAAAAAAAAAAAAAAMAAAAAQAAAAAAAAAAAAAAAAAAAB8AAABUAAAA+/v+AAAAAAEAAAAAAAAAAAAAAAAAAAAAAAAAAAAAAAAAAAAAAAAAAAAAAAJ/f38AAAAAA8zMzADAwP8Af39/AAAAAAAAAAAAAAAAAAAAAAAAAAAAIQAAABgAAAAUAAAAOwIAAPIJAABxHwAALycAABAAAAAmAAAACAAAAP//////////"/>
+                <pr:smNativeData xmlns:pr="smNativeData" xmlns="smNativeData" val="SMDATA_15_bQt8ZhMAAAAlAAAAZAAAAA0AAAAAkAAAAJAAAACQAAAAkAAAAAAAAAABAAAAAAAAAAEAAABQAAAAAAAAAAAA4D8AAAAAAADgPwAAAAAAAOA/AAAAAAAA4D8AAAAAAADgPwAAAAAAAOA/AAAAAAAA4D8AAAAAAADgPwAAAAAAAOA/AAAAAAAA4D8CAAAAjAAAAAEAAAAAAAAA+/v+AP///wgAAAAAAAAAAAAAAAAAAAAAAAAAAAAAAAAAAAAAeAAAAAEAAABAAAAAAAAAAAAAAABaAAAAAAAAAAAAAAAAAAAAAAAAAAAAAAAAAAAAAAAAAAAAAAAAAAAAAAAAAAAAAAAAAAAAAAAAAAAAAAAAAAAAAAAAAAAAAAAAAAAAFAAAADwAAAAAAAAAAAAAAAAAAAkUAAAAAQAAABQAAAAUAAAAFAAAAAEAAAAAAAAAZAAAAGQAAAAAAAAAZAAAAGQAAAAVAAAAYAAAAAAAAAAAAAAADwAAACADAAAAAAAAAAAAAAEAAACgMgAAVgcAAKr4//8BAAAAf39/AAEAAABkAAAAAAAAABQAAABAHwAAAAAAACYAAAAAAAAAwOD//wAAAAAmAAAAZAAAABYAAABMAAAAAAAAAAAAAAAEAAAAAAAAAAEAAABZWVkKAAAAACgAAAAoAAAAZAAAAGQAAAAAAAAAzMzMAAAAAABQAAAAUAAAAGQAAABkAAAAAAAAABcAAAAUAAAAAAAAAAAAAAD/fwAA/38AAAAAAAAJAAAABAAAAAAAAAAeAAAAaAAAAAAAAAAAAAAAAAAAAAAAAAAAAAAAECcAABAnAAAAAAAAAAAAAAAAAAAAAAAAAAAAAAAAAAAAAAAAAAAAABQAAAAAAAAAwMD/AAAAAABkAAAAMgAAAAAAAABkAAAAAAAAAH9/fwAKAAAAIgAAABgAAAAAAAAAAAAAAAAAAAAAAAAAAAAAAAAAAAAkAAAAJAAAAAAAAAAHAAAAAAAAAAAAAAAAAAAAAAAAAAAAAAAAAAAAf39/ACUAAABYAAAAAAAAAAAAAAAAAAAAAAAAAAAAAAAAAAAAAAAAAAAAAAAAAAAAAAAAAAAAAAA/AAAAAAAAAKCGAQAAAAAAAAAAAAAAAAAMAAAAAQAAAAAAAAAAAAAAAAAAAB8AAABUAAAA+/v+AAAAAAEAAAAAAAAAAAAAAAAAAAAAAAAAAAAAAAAAAAAAAAAAAAAAAAJ/f38AAAAAA8zMzADAwP8Af39/AAAAAAAAAAAAAAAAAAAAAAAAAAAAIQAAABgAAAAUAAAAOwIAAPIJAABxHwAALycAABAAAAAmAAAACAAAAP//////////"/>
               </a:ext>
             </a:extLst>
           </p:cNvSpPr>
@@ -3951,7 +3951,7 @@
             <a:spLocks noGrp="1" noChangeArrowheads="1"/>
             <a:extLst>
               <a:ext uri="smNativeData">
-                <pr:smNativeData xmlns:pr="smNativeData" xmlns="smNativeData" val="SMDATA_15_9kV5ZhMAAAAlAAAAZAAAAA0AAAAAkAAAAJAAAACQAAAAkAAAAAAAAAAAAAAAAAAAAAEAAABQAAAAAAAAAAAA4D8AAAAAAADgPwAAAAAAAOA/AAAAAAAA4D8AAAAAAADgPwAAAAAAAOA/AAAAAAAA4D8AAAAAAADgPwAAAAAAAOA/AAAAAAAA4D8CAAAAjAAAAAAAAAAAAAAAQoX0DP///wgAAAAAAAAAAAAAAAAAAAAAAAAAAAAAAAAAAAAAZAAAAAEAAABAAAAAAAAAAAAAAAAAAAAAAAAAAAAAAAAAAAAAAAAAAAAAAAAAAAAAAAAAAAAAAAAAAAAAAAAAAAAAAAAAAAAAAAAAAAAAAAAAAAAAAAAAAAAAAAAAAAAAFAAAADwAAAAAAAAAAAAAAAAAAAkUAAAAAQAAABQAAAAUAAAAFAAAAAEAAAAAAAAAZAAAAGQAAAAAAAAAZAAAAGQAAAAVAAAAYAAAAAAAAAAAAAAADwAAACADAAAAAAAAAAAAAAEAAACgMgAAVgcAAKr4//8BAAAAf39/AAEAAABkAAAAAAAAABQAAABAHwAAAAAAACYAAAAAAAAAwOD//wAAAAAmAAAAZAAAABYAAABMAAAAAAAAAAAAAAAEAAAAAAAAAAEAAABZWVkKAAAAACgAAAAoAAAAZAAAAGQAAAAAAAAAzMzMAAAAAABQAAAAUAAAAGQAAABkAAAAAAAAABcAAAAUAAAAAAAAAAAAAAD/fwAA/38AAAAAAAAJAAAABAAAAAAAAAAeAAAAaAAAAAAAAAAAAAAAAAAAAAAAAAAAAAAAECcAABAnAAAAAAAAAAAAAAAAAAAAAAAAAAAAAAAAAAAAAAAAAAAAABQAAAAAAAAAwMD/AAAAAABkAAAAMgAAAAAAAABkAAAAAAAAAH9/fwAKAAAAIgAAABgAAAAAAAAAAAAAAAAAAAAAAAAAAAAAAAAAAAAkAAAAJAAAAAAAAAAHAAAAAAAAAAAAAAAAAAAAAAAAAAAAAAAAAAAAf39/ACUAAABYAAAAAAAAAAAAAAAAAAAAAAAAAAAAAAAAAAAAAAAAAAAAAAAAAAAAAAAAAAAAAAA/AAAAAAAAAKCGAQAAAAAAAAAAAAAAAAAMAAAAAQAAAAAAAAAAAAAAAAAAAB8AAABUAAAAAAAABQAAAAEAAAAAAAAAAAAAAAAAAAAAAAAAAAAAAAAAAAAAAAAAAAAAAAJ/f38AAAAAA8zMzADAwP8Af39/AAAAAAAAAAAAAAAAAAAAAAAAAAAAIQAAABgAAAAUAAAAFAMAANkKAABSHgAAMCcAABAAAAAmAAAACAAAAD2wAAAAAAAA"/>
+                <pr:smNativeData xmlns:pr="smNativeData" xmlns="smNativeData" val="SMDATA_15_bQt8ZhMAAAAlAAAAZAAAAA0AAAAAkAAAAJAAAACQAAAAkAAAAAAAAAAAAAAAAAAAAAEAAABQAAAAAAAAAAAA4D8AAAAAAADgPwAAAAAAAOA/AAAAAAAA4D8AAAAAAADgPwAAAAAAAOA/AAAAAAAA4D8AAAAAAADgPwAAAAAAAOA/AAAAAAAA4D8CAAAAjAAAAAAAAAAAAAAAQoX0DP///wgAAAAAAAAAAAAAAAAAAAAAAAAAAAAAAAAAAAAAZAAAAAEAAABAAAAAAAAAAAAAAAAAAAAAAAAAAAAAAAAAAAAAAAAAAAAAAAAAAAAAAAAAAAAAAAAAAAAAAAAAAAAAAAAAAAAAAAAAAAAAAAAAAAAAAAAAAAAAAAAAAAAAFAAAADwAAAAAAAAAAAAAAAAAAAkUAAAAAQAAABQAAAAUAAAAFAAAAAEAAAAAAAAAZAAAAGQAAAAAAAAAZAAAAGQAAAAVAAAAYAAAAAAAAAAAAAAADwAAACADAAAAAAAAAAAAAAEAAACgMgAAVgcAAKr4//8BAAAAf39/AAEAAABkAAAAAAAAABQAAABAHwAAAAAAACYAAAAAAAAAwOD//wAAAAAmAAAAZAAAABYAAABMAAAAAAAAAAAAAAAEAAAAAAAAAAEAAABZWVkKAAAAACgAAAAoAAAAZAAAAGQAAAAAAAAAzMzMAAAAAABQAAAAUAAAAGQAAABkAAAAAAAAABcAAAAUAAAAAAAAAAAAAAD/fwAA/38AAAAAAAAJAAAABAAAAAAAAAAeAAAAaAAAAAAAAAAAAAAAAAAAAAAAAAAAAAAAECcAABAnAAAAAAAAAAAAAAAAAAAAAAAAAAAAAAAAAAAAAAAAAAAAABQAAAAAAAAAwMD/AAAAAABkAAAAMgAAAAAAAABkAAAAAAAAAH9/fwAKAAAAIgAAABgAAAAAAAAAAAAAAAAAAAAAAAAAAAAAAAAAAAAkAAAAJAAAAAAAAAAHAAAAAAAAAAAAAAAAAAAAAAAAAAAAAAAAAAAAf39/ACUAAABYAAAAAAAAAAAAAAAAAAAAAAAAAAAAAAAAAAAAAAAAAAAAAAAAAAAAAAAAAAAAAAA/AAAAAAAAAKCGAQAAAAAAAAAAAAAAAAAMAAAAAQAAAAAAAAAAAAAAAAAAAB8AAABUAAAAAAAABQAAAAEAAAAAAAAAAAAAAAAAAAAAAAAAAAAAAAAAAAAAAAAAAAAAAAJ/f38AAAAAA8zMzADAwP8Af39/AAAAAAAAAAAAAAAAAAAAAAAAAAAAIQAAABgAAAAUAAAAFAMAANkKAABSHgAAMCcAABAAAAAmAAAACAAAAD2wAAAAAAAA"/>
               </a:ext>
             </a:extLst>
           </p:cNvSpPr>
@@ -4106,7 +4106,7 @@
             <a:spLocks noGrp="1" noChangeArrowheads="1"/>
             <a:extLst>
               <a:ext uri="smNativeData">
-                <pr:smNativeData xmlns:pr="smNativeData" xmlns="smNativeData" val="SMDATA_15_9kV5ZhMAAAAlAAAAZAAAAA0AAAAAkAAAAJAAAACQAAAAkAAAAAAAAAAAAAAAAAAAAAEAAABQAAAAAAAAAAAA4D8AAAAAAADgPwAAAAAAAOA/AAAAAAAA4D8AAAAAAADgPwAAAAAAAOA/AAAAAAAA4D8AAAAAAADgPwAAAAAAAOA/AAAAAAAA4D8CAAAAjAAAAAAAAAAAAAAAQoX0DP///wgAAAAAAAAAAAAAAAAAAAAAAAAAAAAAAAAAAAAAZAAAAAEAAABAAAAAAAAAAAAAAAAAAAAAAAAAAAAAAAAAAAAAAAAAAAAAAAAAAAAAAAAAAAAAAAAAAAAAAAAAAAAAAAAAAAAAAAAAAAAAAAAAAAAAAAAAAAAAAAAAAAAAFAAAADwAAAAAAAAAAAAAAAAAAAkUAAAAAQAAABQAAAAUAAAAFAAAAAEAAAAAAAAAZAAAAGQAAAAAAAAAZAAAAGQAAAAVAAAAYAAAAAAAAAAAAAAADwAAACADAAAAAAAAAAAAAAEAAACgMgAAVgcAAKr4//8BAAAAf39/AAEAAABkAAAAAAAAABQAAABAHwAAAAAAACYAAAAAAAAAwOD//wAAAAAmAAAAZAAAABYAAABMAAAAAAAAAAAAAAAEAAAAAAAAAAEAAABZWVkKAAAAACgAAAAoAAAAZAAAAGQAAAAAAAAAzMzMAAAAAABQAAAAUAAAAGQAAABkAAAAAAAAABcAAAAUAAAAAAAAAAAAAAD/fwAA/38AAAAAAAAJAAAABAAAAAAAAAAeAAAAaAAAAAAAAAAAAAAAAAAAAAAAAAAAAAAAECcAABAnAAAAAAAAAAAAAAAAAAAAAAAAAAAAAAAAAAAAAAAAAAAAABQAAAAAAAAAwMD/AAAAAABkAAAAMgAAAAAAAABkAAAAAAAAAH9/fwAKAAAAIgAAABgAAAAAAAAAAAAAAAAAAAAAAAAAAAAAAAAAAAAkAAAAJAAAAAAAAAAHAAAAAAAAAAAAAAAAAAAAAAAAAAAAAAAAAAAAf39/ACUAAABYAAAAAAAAAAAAAAAAAAAAAAAAAAAAAAAAAAAAAAAAAAAAAAAAAAAAAAAAAAAAAAA/AAAAAAAAAKCGAQAAAAAAAAAAAAAAAAAMAAAAAQAAAAAAAAAAAAAAAAAAAB8AAABUAAAAAAAABQAAAAEAAAAAAAAAAAAAAAAAAAAAAAAAAAAAAAAAAAAAAAAAAAAAAAJ/f38AAAAAA8zMzADAwP8Af39/AAAAAAAAAAAAAAAAAAAAAAAAAAAAIQAAABgAAAAUAAAALCIAANkKAACPNQAAmCUAABAAAAAmAAAACAAAAD2wAAAAAAAA"/>
+                <pr:smNativeData xmlns:pr="smNativeData" xmlns="smNativeData" val="SMDATA_15_bQt8ZhMAAAAlAAAAZAAAAA0AAAAAkAAAAJAAAACQAAAAkAAAAAAAAAAAAAAAAAAAAAEAAABQAAAAAAAAAAAA4D8AAAAAAADgPwAAAAAAAOA/AAAAAAAA4D8AAAAAAADgPwAAAAAAAOA/AAAAAAAA4D8AAAAAAADgPwAAAAAAAOA/AAAAAAAA4D8CAAAAjAAAAAAAAAAAAAAAQoX0DP///wgAAAAAAAAAAAAAAAAAAAAAAAAAAAAAAAAAAAAAZAAAAAEAAABAAAAAAAAAAAAAAAAAAAAAAAAAAAAAAAAAAAAAAAAAAAAAAAAAAAAAAAAAAAAAAAAAAAAAAAAAAAAAAAAAAAAAAAAAAAAAAAAAAAAAAAAAAAAAAAAAAAAAFAAAADwAAAAAAAAAAAAAAAAAAAkUAAAAAQAAABQAAAAUAAAAFAAAAAEAAAAAAAAAZAAAAGQAAAAAAAAAZAAAAGQAAAAVAAAAYAAAAAAAAAAAAAAADwAAACADAAAAAAAAAAAAAAEAAACgMgAAVgcAAKr4//8BAAAAf39/AAEAAABkAAAAAAAAABQAAABAHwAAAAAAACYAAAAAAAAAwOD//wAAAAAmAAAAZAAAABYAAABMAAAAAAAAAAAAAAAEAAAAAAAAAAEAAABZWVkKAAAAACgAAAAoAAAAZAAAAGQAAAAAAAAAzMzMAAAAAABQAAAAUAAAAGQAAABkAAAAAAAAABcAAAAUAAAAAAAAAAAAAAD/fwAA/38AAAAAAAAJAAAABAAAAAAAAAAeAAAAaAAAAAAAAAAAAAAAAAAAAAAAAAAAAAAAECcAABAnAAAAAAAAAAAAAAAAAAAAAAAAAAAAAAAAAAAAAAAAAAAAABQAAAAAAAAAwMD/AAAAAABkAAAAMgAAAAAAAABkAAAAAAAAAH9/fwAKAAAAIgAAABgAAAAAAAAAAAAAAAAAAAAAAAAAAAAAAAAAAAAkAAAAJAAAAAAAAAAHAAAAAAAAAAAAAAAAAAAAAAAAAAAAAAAAAAAAf39/ACUAAABYAAAAAAAAAAAAAAAAAAAAAAAAAAAAAAAAAAAAAAAAAAAAAAAAAAAAAAAAAAAAAAA/AAAAAAAAAKCGAQAAAAAAAAAAAAAAAAAMAAAAAQAAAAAAAAAAAAAAAAAAAB8AAABUAAAAAAAABQAAAAEAAAAAAAAAAAAAAAAAAAAAAAAAAAAAAAAAAAAAAAAAAAAAAAJ/f38AAAAAA8zMzADAwP8Af39/AAAAAAAAAAAAAAAAAAAAAAAAAAAAIQAAABgAAAAUAAAALCIAANkKAACPNQAAmCUAABAAAAAmAAAACAAAAD2wAAAAAAAA"/>
               </a:ext>
             </a:extLst>
           </p:cNvSpPr>
@@ -4318,7 +4318,7 @@
             <a:spLocks noGrp="1" noChangeArrowheads="1"/>
             <a:extLst>
               <a:ext uri="smNativeData">
-                <pr:smNativeData xmlns:pr="smNativeData" xmlns="smNativeData" val="SMDATA_15_9kV5ZhMAAAAlAAAAZAAAAA0AAAAAkAAAAJAAAACQAAAAkAAAAAAAAAABAAAAAAAAAAEAAABQAAAAAAAAAAAA4D8AAAAAAADgPwAAAAAAAOA/AAAAAAAA4D8AAAAAAADgPwAAAAAAAOA/AAAAAAAA4D8AAAAAAADgPwAAAAAAAOA/AAAAAAAA4D8CAAAAjAAAAAAAAAAAAAAAQoX0DP///wgAAAAAAAAAAAAAAAAAAAAAAAAAAAAAAAAAAAAAZAAAAAEAAABAAAAAAAAAAAAAAAAAAAAAAAAAAAAAAAAAAAAAAAAAAAAAAAAAAAAAAAAAAAAAAAAAAAAAAAAAAAAAAAAAAAAAAAAAAAAAAAAAAAAAAAAAAAAAAAAAAAAAFAAAADwAAAAAAAAAAAAAAAAAAAkUAAAAAQAAABQAAAAUAAAAFAAAAAEAAAAAAAAAZAAAAGQAAAAAAAAAZAAAAGQAAAAVAAAAYAAAAAAAAAAAAAAADwAAACADAAAAAAAAAAAAAAEAAACgMgAAVgcAAKr4//8BAAAAf39/AAEAAABkAAAAAAAAABQAAABAHwAAAAAAACYAAAAAAAAAwOD//wAAAAAmAAAAZAAAABYAAABMAAAAAAAAAAAAAAAEAAAAAAAAAAEAAABZWVkKAAAAACgAAAAoAAAAZAAAAGQAAAAAAAAAzMzMAAAAAABQAAAAUAAAAGQAAABkAAAAAAAAABcAAAAUAAAAAAAAAAAAAAD/fwAA/38AAAAAAAAJAAAABAAAAAAAAAAeAAAAaAAAAAAAAAAAAAAAAAAAAAAAAAAAAAAAECcAABAnAAAAAAAAAAAAAAAAAAAAAAAAAAAAAAAAAAAAAAAAAAAAABQAAAAAAAAAwMD/AAAAAABkAAAAMgAAAAAAAABkAAAAAAAAAH9/fwAKAAAAIgAAABgAAAAAAAAAAAAAAAAAAAAAAAAAAAAAAAAAAAAkAAAAJAAAAAAAAAAHAAAAAAAAAAAAAAAAAAAAAAAAAAAAAAAAAAAAf39/ACUAAABYAAAAAAAAAAAAAAAAAAAAAAAAAAAAAAAAAAAAAAAAAAAAAAAAAAAAAAAAAAAAAAA/AAAAAAAAAKCGAQAAAAAAAAAAAAAAAAAMAAAAAQAAAAAAAAAAAAAAAAAAAB8AAABUAAAAAAAABQAAAAEAAAAAAAAAAAAAAAAAAAAAAAAAAAAAAAAAAAAAAAAAAAAAAAJ/f38AAAAAA8zMzADAwP8Af39/AAAAAAAAAAAAAAAAAAAAAAAAAAAAIQAAABgAAAAUAAAAFAMAAEoPAADlMwAAMhYAABAAAAAmAAAACAAAAL2wAAAAAAAA"/>
+                <pr:smNativeData xmlns:pr="smNativeData" xmlns="smNativeData" val="SMDATA_15_bQt8ZhMAAAAlAAAAZAAAAA0AAAAAkAAAAJAAAACQAAAAkAAAAAAAAAABAAAAAAAAAAEAAABQAAAAAAAAAAAA4D8AAAAAAADgPwAAAAAAAOA/AAAAAAAA4D8AAAAAAADgPwAAAAAAAOA/AAAAAAAA4D8AAAAAAADgPwAAAAAAAOA/AAAAAAAA4D8CAAAAjAAAAAAAAAAAAAAAQoX0DP///wgAAAAAAAAAAAAAAAAAAAAAAAAAAAAAAAAAAAAAZAAAAAEAAABAAAAAAAAAAAAAAAAAAAAAAAAAAAAAAAAAAAAAAAAAAAAAAAAAAAAAAAAAAAAAAAAAAAAAAAAAAAAAAAAAAAAAAAAAAAAAAAAAAAAAAAAAAAAAAAAAAAAAFAAAADwAAAAAAAAAAAAAAAAAAAkUAAAAAQAAABQAAAAUAAAAFAAAAAEAAAAAAAAAZAAAAGQAAAAAAAAAZAAAAGQAAAAVAAAAYAAAAAAAAAAAAAAADwAAACADAAAAAAAAAAAAAAEAAACgMgAAVgcAAKr4//8BAAAAf39/AAEAAABkAAAAAAAAABQAAABAHwAAAAAAACYAAAAAAAAAwOD//wAAAAAmAAAAZAAAABYAAABMAAAAAAAAAAAAAAAEAAAAAAAAAAEAAABZWVkKAAAAACgAAAAoAAAAZAAAAGQAAAAAAAAAzMzMAAAAAABQAAAAUAAAAGQAAABkAAAAAAAAABcAAAAUAAAAAAAAAAAAAAD/fwAA/38AAAAAAAAJAAAABAAAAAAAAAAeAAAAaAAAAAAAAAAAAAAAAAAAAAAAAAAAAAAAECcAABAnAAAAAAAAAAAAAAAAAAAAAAAAAAAAAAAAAAAAAAAAAAAAABQAAAAAAAAAwMD/AAAAAABkAAAAMgAAAAAAAABkAAAAAAAAAH9/fwAKAAAAIgAAABgAAAAAAAAAAAAAAAAAAAAAAAAAAAAAAAAAAAAkAAAAJAAAAAAAAAAHAAAAAAAAAAAAAAAAAAAAAAAAAAAAAAAAAAAAf39/ACUAAABYAAAAAAAAAAAAAAAAAAAAAAAAAAAAAAAAAAAAAAAAAAAAAAAAAAAAAAAAAAAAAAA/AAAAAAAAAKCGAQAAAAAAAAAAAAAAAAAMAAAAAQAAAAAAAAAAAAAAAAAAAB8AAABUAAAAAAAABQAAAAEAAAAAAAAAAAAAAAAAAAAAAAAAAAAAAAAAAAAAAAAAAAAAAAJ/f38AAAAAA8zMzADAwP8Af39/AAAAAAAAAAAAAAAAAAAAAAAAAAAAIQAAABgAAAAUAAAAFAMAAEoPAADlMwAAMhYAABAAAAAmAAAACAAAAL2wAAAAAAAA"/>
               </a:ext>
             </a:extLst>
           </p:cNvSpPr>
@@ -4442,7 +4442,7 @@
             <a:spLocks noGrp="1" noChangeArrowheads="1"/>
             <a:extLst>
               <a:ext uri="smNativeData">
-                <pr:smNativeData xmlns:pr="smNativeData" xmlns="smNativeData" val="SMDATA_15_9kV5ZhMAAAAlAAAAZAAAAA0AAAAAkAAAAJAAAACQAAAAkAAAAAAAAAABAAAAAAAAAAEAAABQAAAAAAAAAAAA4D8AAAAAAADgPwAAAAAAAOA/AAAAAAAA4D8AAAAAAADgPwAAAAAAAOA/AAAAAAAA4D8AAAAAAADgPwAAAAAAAOA/AAAAAAAA4D8CAAAAjAAAAAAAAAAAAAAAQoX0DP///wgAAAAAAAAAAAAAAAAAAAAAAAAAAAAAAAAAAAAAZAAAAAEAAABAAAAAAAAAAAAAAAAAAAAAAAAAAAAAAAAAAAAAAAAAAAAAAAAAAAAAAAAAAAAAAAAAAAAAAAAAAAAAAAAAAAAAAAAAAAAAAAAAAAAAAAAAAAAAAAAAAAAAFAAAADwAAAAAAAAAAAAAAAAAAAkUAAAAAQAAABQAAAAUAAAAFAAAAAEAAAAAAAAAZAAAAGQAAAAAAAAAZAAAAGQAAAAVAAAAYAAAAAAAAAAAAAAADwAAACADAAAAAAAAAAAAAAEAAACgMgAAVgcAAKr4//8BAAAAf39/AAEAAABkAAAAAAAAABQAAABAHwAAAAAAACYAAAAAAAAAwOD//wAAAAAmAAAAZAAAABYAAABMAAAAAAAAAAAAAAAEAAAAAAAAAAEAAABZWVkKAAAAACgAAAAoAAAAZAAAAGQAAAAAAAAAzMzMAAAAAABQAAAAUAAAAGQAAABkAAAAAAAAABcAAAAUAAAAAAAAAAAAAAD/fwAA/38AAAAAAAAJAAAABAAAAAAAAAAeAAAAaAAAAAAAAAAAAAAAAAAAAAAAAAAAAAAAECcAABAnAAAAAAAAAAAAAAAAAAAAAAAAAAAAAAAAAAAAAAAAAAAAABQAAAAAAAAAwMD/AAAAAABkAAAAMgAAAAAAAABkAAAAAAAAAH9/fwAKAAAAIgAAABgAAAAAAAAAAAAAAAAAAAAAAAAAAAAAAAAAAAAkAAAAJAAAAAAAAAAHAAAAAAAAAAAAAAAAAAAAAAAAAAAAAAAAAAAAf39/ACUAAABYAAAAAAAAAAAAAAAAAAAAAAAAAAAAAAAAAAAAAAAAAAAAAAAAAAAAAAAAAAAAAAA/AAAAAAAAAKCGAQAAAAAAAAAAAAAAAAAMAAAAAQAAAAAAAAAAAAAAAAAAAB8AAABUAAAAAAAABQAAAAEAAAAAAAAAAAAAAAAAAAAAAAAAAAAAAAAAAAAAAAAAAAAAAAJ/f38AAAAAA8zMzADAwP8Af39/AAAAAAAAAAAAAAAAAAAAAAAAAAAAIQAAABgAAAAUAAAAHjQAAEAmAAB/NwAAeikAABAAAAAmAAAACAAAADywAAAAAAAA"/>
+                <pr:smNativeData xmlns:pr="smNativeData" xmlns="smNativeData" val="SMDATA_15_bQt8ZhMAAAAlAAAAZAAAAA0AAAAAkAAAAJAAAACQAAAAkAAAAAAAAAABAAAAAAAAAAEAAABQAAAAAAAAAAAA4D8AAAAAAADgPwAAAAAAAOA/AAAAAAAA4D8AAAAAAADgPwAAAAAAAOA/AAAAAAAA4D8AAAAAAADgPwAAAAAAAOA/AAAAAAAA4D8CAAAAjAAAAAAAAAAAAAAAQoX0DP///wgAAAAAAAAAAAAAAAAAAAAAAAAAAAAAAAAAAAAAZAAAAAEAAABAAAAAAAAAAAAAAAAAAAAAAAAAAAAAAAAAAAAAAAAAAAAAAAAAAAAAAAAAAAAAAAAAAAAAAAAAAAAAAAAAAAAAAAAAAAAAAAAAAAAAAAAAAAAAAAAAAAAAFAAAADwAAAAAAAAAAAAAAAAAAAkUAAAAAQAAABQAAAAUAAAAFAAAAAEAAAAAAAAAZAAAAGQAAAAAAAAAZAAAAGQAAAAVAAAAYAAAAAAAAAAAAAAADwAAACADAAAAAAAAAAAAAAEAAACgMgAAVgcAAKr4//8BAAAAf39/AAEAAABkAAAAAAAAABQAAABAHwAAAAAAACYAAAAAAAAAwOD//wAAAAAmAAAAZAAAABYAAABMAAAAAAAAAAAAAAAEAAAAAAAAAAEAAABZWVkKAAAAACgAAAAoAAAAZAAAAGQAAAAAAAAAzMzMAAAAAABQAAAAUAAAAGQAAABkAAAAAAAAABcAAAAUAAAAAAAAAAAAAAD/fwAA/38AAAAAAAAJAAAABAAAAAAAAAAeAAAAaAAAAAAAAAAAAAAAAAAAAAAAAAAAAAAAECcAABAnAAAAAAAAAAAAAAAAAAAAAAAAAAAAAAAAAAAAAAAAAAAAABQAAAAAAAAAwMD/AAAAAABkAAAAMgAAAAAAAABkAAAAAAAAAH9/fwAKAAAAIgAAABgAAAAAAAAAAAAAAAAAAAAAAAAAAAAAAAAAAAAkAAAAJAAAAAAAAAAHAAAAAAAAAAAAAAAAAAAAAAAAAAAAAAAAAAAAf39/ACUAAABYAAAAAAAAAAAAAAAAAAAAAAAAAAAAAAAAAAAAAAAAAAAAAAAAAAAAAAAAAAAAAAA/AAAAAAAAAKCGAQAAAAAAAAAAAAAAAAAMAAAAAQAAAAAAAAAAAAAAAAAAAB8AAABUAAAAAAAABQAAAAEAAAAAAAAAAAAAAAAAAAAAAAAAAAAAAAAAAAAAAAAAAAAAAAJ/f38AAAAAA8zMzADAwP8Af39/AAAAAAAAAAAAAAAAAAAAAAAAAAAAIQAAABgAAAAUAAAAHjQAAEAmAAB/NwAAeikAABAAAAAmAAAACAAAADywAAAAAAAA"/>
               </a:ext>
             </a:extLst>
           </p:cNvSpPr>
@@ -4496,7 +4496,7 @@
               </a:spcAft>
               <a:buNone/>
             </a:pPr>
-            <a:fld id="{3FDDF580-CED2-8803-9C65-3856BB2B6A6D}" type="slidenum">
+            <a:fld id="{3B5D0813-5DD6-08FE-98E5-ABAB46AB6EFE}" type="slidenum">
               <a:rPr lang="ru-ru" cap="none"/>
               <a:t/>
             </a:fld>
@@ -4537,7 +4537,7 @@
             <a:spLocks noGrp="1" noChangeArrowheads="1"/>
             <a:extLst>
               <a:ext uri="smNativeData">
-                <pr:smNativeData xmlns:pr="smNativeData" xmlns="smNativeData" val="SMDATA_15_9kV5ZhMAAAAlAAAAZAAAAA0AAAAAkAAAAJAAAACQAAAAkAAAAAAAAAAAAAAAAAAAAAEAAABQAAAAAAAAAAAA4D8AAAAAAADgPwAAAAAAAOA/AAAAAAAA4D8AAAAAAADgPwAAAAAAAOA/AAAAAAAA4D8AAAAAAADgPwAAAAAAAOA/AAAAAAAA4D8CAAAAjAAAAAAAAAAAAAAAQoX0DP///wgAAAAAAAAAAAAAAAAAAAAAAAAAAAAAAAAAAAAAZAAAAAEAAABAAAAAAAAAAAAAAAAAAAAAAAAAAAAAAAAAAAAAAAAAAAAAAAAAAAAAAAAAAAAAAAAAAAAAAAAAAAAAAAAAAAAAAAAAAAAAAAAAAAAAAAAAAAAAAAAAAAAAFAAAADwAAAAAAAAAAAAAAAAAAAkUAAAAAQAAABQAAAAUAAAAFAAAAAEAAAAAAAAAZAAAAGQAAAAAAAAAZAAAAGQAAAAVAAAAYAAAAAAAAAAAAAAADwAAACADAAAAAAAAAAAAAAEAAACgMgAAVgcAAKr4//8BAAAAf39/AAEAAABkAAAAAAAAABQAAABAHwAAAAAAACYAAAAAAAAAwOD//wAAAAAmAAAAZAAAABYAAABMAAAAAAAAAAAAAAAEAAAAAAAAAAEAAABZWVkKAAAAACgAAAAoAAAAZAAAAGQAAAAAAAAAzMzMAAAAAABQAAAAUAAAAGQAAABkAAAAAAAAABcAAAAUAAAAAAAAAAAAAAD/fwAA/38AAAAAAAAJAAAABAAAAMhrcwceAAAAaAAAAAAAAAAAAAAAAAAAAAAAAAAAAAAAECcAABAnAAAAAAAAAAAAAAAAAAAAAAAAAAAAAAAAAAAAAAAAAAAAABQAAAAAAAAAwMD/AAAAAABkAAAAMgAAAAAAAABkAAAAAAAAAH9/fwAKAAAAIgAAABgAAAAAAAAAAAAAAAAAAAAAAAAAAAAAAAAAAAAkAAAAJAAAAAAAAAAHAAAAAAAAAAAAAAAAAAAAAAAAAAAAAAAAAAAAf39/ACUAAABYAAAAAAAAAAAAAAAAAAAAAAAAAAAAAAAAAAAAAAAAAAAAAAAAAAAAAAAAAAAAAAA/AAAAAAAAAKCGAQAAAAAAAAAAAAAAAAAMAAAAAQAAAAAAAAAAAAAAAAAAAB8AAABUAAAAAAAABQAAAAEAAAAAAAAAAAAAAAAAAAAAAAAAAAAAAAAAAAAAAAAAAAAAAAJ/f38AAAAAA8zMzADAwP8Af39/AAAAAAAAAAAAAAAAAAAAAAAAAAAAIQAAABgAAAAUAAAAFAMAALYCAAB/NwAAvwoAABAAAAAmAAAACAAAADywAAAAAAAA"/>
+                <pr:smNativeData xmlns:pr="smNativeData" xmlns="smNativeData" val="SMDATA_15_bQt8ZhMAAAAlAAAAZAAAAA0AAAAAkAAAAJAAAACQAAAAkAAAAAAAAAAAAAAAAAAAAAEAAABQAAAAAAAAAAAA4D8AAAAAAADgPwAAAAAAAOA/AAAAAAAA4D8AAAAAAADgPwAAAAAAAOA/AAAAAAAA4D8AAAAAAADgPwAAAAAAAOA/AAAAAAAA4D8CAAAAjAAAAAAAAAAAAAAAQoX0DP///wgAAAAAAAAAAAAAAAAAAAAAAAAAAAAAAAAAAAAAZAAAAAEAAABAAAAAAAAAAAAAAAAAAAAAAAAAAAAAAAAAAAAAAAAAAAAAAAAAAAAAAAAAAAAAAAAAAAAAAAAAAAAAAAAAAAAAAAAAAAAAAAAAAAAAAAAAAAAAAAAAAAAAFAAAADwAAAAAAAAAAAAAAAAAAAkUAAAAAQAAABQAAAAUAAAAFAAAAAEAAAAAAAAAZAAAAGQAAAAAAAAAZAAAAGQAAAAVAAAAYAAAAAAAAAAAAAAADwAAACADAAAAAAAAAAAAAAEAAACgMgAAVgcAAKr4//8BAAAAf39/AAEAAABkAAAAAAAAABQAAABAHwAAAAAAACYAAAAAAAAAwOD//wAAAAAmAAAAZAAAABYAAABMAAAAAAAAAAAAAAAEAAAAAAAAAAEAAABZWVkKAAAAACgAAAAoAAAAZAAAAGQAAAAAAAAAzMzMAAAAAABQAAAAUAAAAGQAAABkAAAAAAAAABcAAAAUAAAAAAAAAAAAAAD/fwAA/38AAAAAAAAJAAAABAAAAMhrcwceAAAAaAAAAAAAAAAAAAAAAAAAAAAAAAAAAAAAECcAABAnAAAAAAAAAAAAAAAAAAAAAAAAAAAAAAAAAAAAAAAAAAAAABQAAAAAAAAAwMD/AAAAAABkAAAAMgAAAAAAAABkAAAAAAAAAH9/fwAKAAAAIgAAABgAAAAAAAAAAAAAAAAAAAAAAAAAAAAAAAAAAAAkAAAAJAAAAAAAAAAHAAAAAAAAAAAAAAAAAAAAAAAAAAAAAAAAAAAAf39/ACUAAABYAAAAAAAAAAAAAAAAAAAAAAAAAAAAAAAAAAAAAAAAAAAAAAAAAAAAAAAAAAAAAAA/AAAAAAAAAKCGAQAAAAAAAAAAAAAAAAAMAAAAAQAAAAAAAAAAAAAAAAAAAB8AAABUAAAAAAAABQAAAAEAAAAAAAAAAAAAAAAAAAAAAAAAAAAAAAAAAAAAAAAAAAAAAAJ/f38AAAAAA8zMzADAwP8Af39/AAAAAAAAAAAAAAAAAAAAAAAAAAAAIQAAABgAAAAUAAAAFAMAALYCAAB/NwAAvwoAABAAAAAmAAAACAAAADywAAAAAAAA"/>
               </a:ext>
             </a:extLst>
           </p:cNvSpPr>
@@ -4647,7 +4647,7 @@
             <a:spLocks noGrp="1" noChangeArrowheads="1"/>
             <a:extLst>
               <a:ext uri="smNativeData">
-                <pr:smNativeData xmlns:pr="smNativeData" xmlns="smNativeData" val="SMDATA_15_9kV5ZhMAAAAlAAAAZAAAAA0AAAAAkAAAAJAAAACQAAAAkAAAAAAAAAAAAAAAAAAAAAEAAABQAAAAAAAAAAAA4D8AAAAAAADgPwAAAAAAAOA/AAAAAAAA4D8AAAAAAADgPwAAAAAAAOA/AAAAAAAA4D8AAAAAAADgPwAAAAAAAOA/AAAAAAAA4D8CAAAAjAAAAAAAAAAAAAAAQoX0DP///wgAAAAAAAAAAAAAAAAAAAAAAAAAAAAAAAAAAAAAZAAAAAEAAABAAAAAAAAAAAAAAAAAAAAAAAAAAAAAAAAAAAAAAAAAAAAAAAAAAAAAAAAAAAAAAAAAAAAAAAAAAAAAAAAAAAAAAAAAAAAAAAAAAAAAAAAAAAAAAAAAAAAAFAAAADwAAAAAAAAAAAAAAAAAAAkUAAAAAQAAABQAAAAUAAAAFAAAAAEAAAAAAAAAZAAAAGQAAAAAAAAAZAAAAGQAAAAVAAAAYAAAAAAAAAAAAAAADwAAACADAAAAAAAAAAAAAAEAAACgMgAAVgcAAKr4//8BAAAAf39/AAEAAABkAAAAAAAAABQAAABAHwAAAAAAACYAAAAAAAAAwOD//wAAAAAmAAAAZAAAABYAAABMAAAAAAAAAAAAAAAEAAAAAAAAAAEAAABZWVkKAAAAACgAAAAoAAAAZAAAAGQAAAAAAAAAzMzMAAAAAABQAAAAUAAAAGQAAABkAAAAAAAAABcAAAAUAAAAAAAAAAAAAAD/fwAA/38AAAAAAAAJAAAABAAAAF8AYAAeAAAAaAAAAAAAAAAAAAAAAAAAAAAAAAAAAAAAECcAABAnAAAAAAAAAAAAAAAAAAAAAAAAAAAAAAAAAAAAAAAAAAAAABQAAAAAAAAAwMD/AAAAAABkAAAAMgAAAAAAAABkAAAAAAAAAH9/fwAKAAAAIgAAABgAAAAAAAAAAAAAAAAAAAAAAAAAAAAAAAAAAAAkAAAAJAAAAAAAAAAHAAAAAAAAAAAAAAAAAAAAAAAAAAAAAAAAAAAAf39/ACUAAABYAAAAAAAAAAAAAAAAAAAAAAAAAAAAAAAAAAAAAAAAAAAAAAAAAAAAAAAAAAAAAAA/AAAAAAAAAKCGAQAAAAAAAAAAAAAAAAAMAAAAAQAAAAAAAAAAAAAAAAAAAB8AAABUAAAAAAAABQAAAAEAAAAAAAAAAAAAAAAAAAAAAAAAAAAAAAAAAAAAAAAAAAAAAAJ/f38AAAAAA8zMzADAwP8Af39/AAAAAAAAAAAAAAAAAAAAAAAAAAAAIQAAABgAAAAUAAAAFAMAALMLAAB/NwAAuScAABAAAAAmAAAACAAAAD2wAAAAAAAA"/>
+                <pr:smNativeData xmlns:pr="smNativeData" xmlns="smNativeData" val="SMDATA_15_bQt8ZhMAAAAlAAAAZAAAAA0AAAAAkAAAAJAAAACQAAAAkAAAAAAAAAAAAAAAAAAAAAEAAABQAAAAAAAAAAAA4D8AAAAAAADgPwAAAAAAAOA/AAAAAAAA4D8AAAAAAADgPwAAAAAAAOA/AAAAAAAA4D8AAAAAAADgPwAAAAAAAOA/AAAAAAAA4D8CAAAAjAAAAAAAAAAAAAAAQoX0DP///wgAAAAAAAAAAAAAAAAAAAAAAAAAAAAAAAAAAAAAZAAAAAEAAABAAAAAAAAAAAAAAAAAAAAAAAAAAAAAAAAAAAAAAAAAAAAAAAAAAAAAAAAAAAAAAAAAAAAAAAAAAAAAAAAAAAAAAAAAAAAAAAAAAAAAAAAAAAAAAAAAAAAAFAAAADwAAAAAAAAAAAAAAAAAAAkUAAAAAQAAABQAAAAUAAAAFAAAAAEAAAAAAAAAZAAAAGQAAAAAAAAAZAAAAGQAAAAVAAAAYAAAAAAAAAAAAAAADwAAACADAAAAAAAAAAAAAAEAAACgMgAAVgcAAKr4//8BAAAAf39/AAEAAABkAAAAAAAAABQAAABAHwAAAAAAACYAAAAAAAAAwOD//wAAAAAmAAAAZAAAABYAAABMAAAAAAAAAAAAAAAEAAAAAAAAAAEAAABZWVkKAAAAACgAAAAoAAAAZAAAAGQAAAAAAAAAzMzMAAAAAABQAAAAUAAAAGQAAABkAAAAAAAAABcAAAAUAAAAAAAAAAAAAAD/fwAA/38AAAAAAAAJAAAABAAAAF8AYAAeAAAAaAAAAAAAAAAAAAAAAAAAAAAAAAAAAAAAECcAABAnAAAAAAAAAAAAAAAAAAAAAAAAAAAAAAAAAAAAAAAAAAAAABQAAAAAAAAAwMD/AAAAAABkAAAAMgAAAAAAAABkAAAAAAAAAH9/fwAKAAAAIgAAABgAAAAAAAAAAAAAAAAAAAAAAAAAAAAAAAAAAAAkAAAAJAAAAAAAAAAHAAAAAAAAAAAAAAAAAAAAAAAAAAAAAAAAAAAAf39/ACUAAABYAAAAAAAAAAAAAAAAAAAAAAAAAAAAAAAAAAAAAAAAAAAAAAAAAAAAAAAAAAAAAAA/AAAAAAAAAKCGAQAAAAAAAAAAAAAAAAAMAAAAAQAAAAAAAAAAAAAAAAAAAB8AAABUAAAAAAAABQAAAAEAAAAAAAAAAAAAAAAAAAAAAAAAAAAAAAAAAAAAAAAAAAAAAAJ/f38AAAAAA8zMzADAwP8Af39/AAAAAAAAAAAAAAAAAAAAAAAAAAAAIQAAABgAAAAUAAAAFAMAALMLAAB/NwAAuScAABAAAAAmAAAACAAAAD2wAAAAAAAA"/>
               </a:ext>
             </a:extLst>
           </p:cNvSpPr>
@@ -4798,7 +4798,7 @@
             <a:spLocks noGrp="1" noChangeArrowheads="1"/>
             <a:extLst>
               <a:ext uri="smNativeData">
-                <pr:smNativeData xmlns:pr="smNativeData" xmlns="smNativeData" val="SMDATA_15_9kV5ZhMAAAAlAAAAZAAAAA0AAAAAkAAAAJAAAACQAAAAkAAAAAAAAAABAAAAAAAAAAEAAABQAAAAAAAAAAAA4D8AAAAAAADgPwAAAAAAAOA/AAAAAAAA4D8AAAAAAADgPwAAAAAAAOA/AAAAAAAA4D8AAAAAAADgPwAAAAAAAOA/AAAAAAAA4D8CAAAAjAAAAAAAAAAAAAAAQoX0DP///wgAAAAAAAAAAAAAAAAAAAAAAAAAAAAAAAAAAAAAZAAAAAEAAABAAAAAAAAAAAAAAAAAAAAAAAAAAAAAAAAAAAAAAAAAAAAAAAAAAAAAAAAAAAAAAAAAAAAAAAAAAAAAAAAAAAAAAAAAAAAAAAAAAAAAAAAAAAAAAAAAAAAAFAAAADwAAAAAAAAAAAAAAAAAAAkUAAAAAQAAABQAAAAUAAAAFAAAAAEAAAAAAAAAZAAAAGQAAAAAAAAAZAAAAGQAAAAVAAAAYAAAAAAAAAAAAAAADwAAACADAAAAAAAAAAAAAAEAAACgMgAAVgcAAKr4//8BAAAAf39/AAEAAABkAAAAAAAAABQAAABAHwAAAAAAACYAAAAAAAAAwOD//wAAAAAmAAAAZAAAABYAAABMAAAAAAAAAAAAAAAEAAAAAAAAAAEAAABZWVkKAAAAACgAAAAoAAAAZAAAAGQAAAAAAAAAzMzMAAAAAABQAAAAUAAAAGQAAABkAAAAAAAAABcAAAAUAAAAAAAAAAAAAAD/fwAA/38AAAAAAAAJAAAABAAAAF8AYAAeAAAAaAAAAAAAAAAAAAAAAAAAAAAAAAAAAAAAECcAABAnAAAAAAAAAAAAAAAAAAAAAAAAAAAAAAAAAAAAAAAAAAAAABQAAAAAAAAAwMD/AAAAAABkAAAAMgAAAAAAAABkAAAAAAAAAH9/fwAKAAAAIgAAABgAAAAAAAAAAAAAAAAAAAAAAAAAAAAAAAAAAAAkAAAAJAAAAAAAAAAHAAAAAAAAAAAAAAAAAAAAAAAAAAAAAAAAAAAAf39/ACUAAABYAAAAAAAAAAAAAAAAAAAAAAAAAAAAAAAAAAAAAAAAAAAAAAAAAAAAAAAAAAAAAAA/AAAAAAAAAKCGAQAAAAAAAAAAAAAAAAAMAAAAAQAAAAAAAAAAAAAAAAAAAB8AAABUAAAAAAAABQAAAAEAAAAAAAAAAAAAAAAAAAAAAAAAAAAAAAAAAAAAAAAAAAAAAAJ/f38AAAAAA8zMzADAwP8Af39/AAAAAAAAAAAAAAAAAAAAAAAAAAAAIQAAABgAAAAUAAAAHjQAAEAmAAB/NwAAeikAABAAAAAmAAAACAAAADywAAAAAAAA"/>
+                <pr:smNativeData xmlns:pr="smNativeData" xmlns="smNativeData" val="SMDATA_15_bQt8ZhMAAAAlAAAAZAAAAA0AAAAAkAAAAJAAAACQAAAAkAAAAAAAAAABAAAAAAAAAAEAAABQAAAAAAAAAAAA4D8AAAAAAADgPwAAAAAAAOA/AAAAAAAA4D8AAAAAAADgPwAAAAAAAOA/AAAAAAAA4D8AAAAAAADgPwAAAAAAAOA/AAAAAAAA4D8CAAAAjAAAAAAAAAAAAAAAQoX0DP///wgAAAAAAAAAAAAAAAAAAAAAAAAAAAAAAAAAAAAAZAAAAAEAAABAAAAAAAAAAAAAAAAAAAAAAAAAAAAAAAAAAAAAAAAAAAAAAAAAAAAAAAAAAAAAAAAAAAAAAAAAAAAAAAAAAAAAAAAAAAAAAAAAAAAAAAAAAAAAAAAAAAAAFAAAADwAAAAAAAAAAAAAAAAAAAkUAAAAAQAAABQAAAAUAAAAFAAAAAEAAAAAAAAAZAAAAGQAAAAAAAAAZAAAAGQAAAAVAAAAYAAAAAAAAAAAAAAADwAAACADAAAAAAAAAAAAAAEAAACgMgAAVgcAAKr4//8BAAAAf39/AAEAAABkAAAAAAAAABQAAABAHwAAAAAAACYAAAAAAAAAwOD//wAAAAAmAAAAZAAAABYAAABMAAAAAAAAAAAAAAAEAAAAAAAAAAEAAABZWVkKAAAAACgAAAAoAAAAZAAAAGQAAAAAAAAAzMzMAAAAAABQAAAAUAAAAGQAAABkAAAAAAAAABcAAAAUAAAAAAAAAAAAAAD/fwAA/38AAAAAAAAJAAAABAAAAF8AYAAeAAAAaAAAAAAAAAAAAAAAAAAAAAAAAAAAAAAAECcAABAnAAAAAAAAAAAAAAAAAAAAAAAAAAAAAAAAAAAAAAAAAAAAABQAAAAAAAAAwMD/AAAAAABkAAAAMgAAAAAAAABkAAAAAAAAAH9/fwAKAAAAIgAAABgAAAAAAAAAAAAAAAAAAAAAAAAAAAAAAAAAAAAkAAAAJAAAAAAAAAAHAAAAAAAAAAAAAAAAAAAAAAAAAAAAAAAAAAAAf39/ACUAAABYAAAAAAAAAAAAAAAAAAAAAAAAAAAAAAAAAAAAAAAAAAAAAAAAAAAAAAAAAAAAAAA/AAAAAAAAAKCGAQAAAAAAAAAAAAAAAAAMAAAAAQAAAAAAAAAAAAAAAAAAAB8AAABUAAAAAAAABQAAAAEAAAAAAAAAAAAAAAAAAAAAAAAAAAAAAAAAAAAAAAAAAAAAAAJ/f38AAAAAA8zMzADAwP8Af39/AAAAAAAAAAAAAAAAAAAAAAAAAAAAIQAAABgAAAAUAAAAHjQAAEAmAAB/NwAAeikAABAAAAAmAAAACAAAADywAAAAAAAA"/>
               </a:ext>
             </a:extLst>
           </p:cNvSpPr>
@@ -4852,7 +4852,7 @@
               </a:spcAft>
               <a:buNone/>
             </a:pPr>
-            <a:fld id="{3FDDCA4B-05D2-883C-9C65-F369842B6AA6}" type="slidenum">
+            <a:fld id="{3B5D6FF0-BED6-0899-98E5-48CC21AB6E1D}" type="slidenum">
               <a:rPr lang="ru-ru" cap="none"/>
               <a:t/>
             </a:fld>
@@ -4893,7 +4893,7 @@
             <a:spLocks noGrp="1" noChangeArrowheads="1"/>
             <a:extLst>
               <a:ext uri="smNativeData">
-                <pr:smNativeData xmlns:pr="smNativeData" xmlns="smNativeData" val="SMDATA_15_9kV5ZhMAAAAlAAAAZAAAAA0AAAAAkAAAAJAAAACQAAAAkAAAAAAAAAABAAAAAAAAAAEAAABQAAAAAAAAAAAA4D8AAAAAAADgPwAAAAAAAOA/AAAAAAAA4D8AAAAAAADgPwAAAAAAAOA/AAAAAAAA4D8AAAAAAADgPwAAAAAAAOA/AAAAAAAA4D8CAAAAjAAAAAAAAAAAAAAAQoX0DP///wgAAAAAAAAAAAAAAAAAAAAAAAAAAAAAAAAAAAAAZAAAAAEAAABAAAAAAAAAAAAAAAAAAAAAAAAAAAAAAAAAAAAAAAAAAAAAAAAAAAAAAAAAAAAAAAAAAAAAAAAAAAAAAAAAAAAAAAAAAAAAAAAAAAAAAAAAAAAAAAAAAAAAFAAAADwAAAAAAAAAAAAAAAAAAAkUAAAAAQAAABQAAAAUAAAAFAAAAAEAAAAAAAAAZAAAAGQAAAAAAAAAZAAAAGQAAAAVAAAAYAAAAAAAAAAAAAAADwAAACADAAAAAAAAAAAAAAEAAACgMgAAVgcAAKr4//8BAAAAf39/AAEAAABkAAAAAAAAABQAAABAHwAAAAAAACYAAAAAAAAAwOD//wAAAAAmAAAAZAAAABYAAABMAAAAAAAAAAAAAAAEAAAAAAAAAAEAAABZWVkKAAAAACgAAAAoAAAAZAAAAGQAAAAAAAAAzMzMAAAAAABQAAAAUAAAAGQAAABkAAAAAAAAABcAAAAUAAAAAAAAAAAAAAD/fwAA/38AAAAAAAAJAAAABAAAAAAAAAAeAAAAaAAAAAAAAAAAAAAAAAAAAAAAAAAAAAAAECcAABAnAAAAAAAAAAAAAAAAAAAAAAAAAAAAAAAAAAAAAAAAAAAAABQAAAAAAAAAwMD/AAAAAABkAAAAMgAAAAAAAABkAAAAAAAAAH9/fwAKAAAAIgAAABgAAAAAAAAAAAAAAAAAAAAAAAAAAAAAAAAAAAAkAAAAJAAAAAAAAAAHAAAAAAAAAAAAAAAAAAAAAAAAAAAAAAAAAAAAf39/ACUAAABYAAAAAAAAAAAAAAAAAAAAAAAAAAAAAAAAAAAAAAAAAAAAAAAAAAAAAAAAAAAAAAA/AAAAAAAAAKCGAQAAAAAAAAAAAAAAAAAMAAAAAQAAAAAAAAAAAAAAAAAAAB8AAABUAAAAAAAABQAAAAEAAAAAAAAAAAAAAAAAAAAAAAAAAAAAAAAAAAAAAAAAAAAAAAJ/f38AAAAAA8zMzADAwP8Af39/AAAAAAAAAAAAAAAAAAAAAAAAAAAAIQAAABgAAAAUAAAAHjQAAEAmAAB/NwAAeikAABAAAAAmAAAACAAAADywAAAAAAAA"/>
+                <pr:smNativeData xmlns:pr="smNativeData" xmlns="smNativeData" val="SMDATA_15_bQt8ZhMAAAAlAAAAZAAAAA0AAAAAkAAAAJAAAACQAAAAkAAAAAAAAAABAAAAAAAAAAEAAABQAAAAAAAAAAAA4D8AAAAAAADgPwAAAAAAAOA/AAAAAAAA4D8AAAAAAADgPwAAAAAAAOA/AAAAAAAA4D8AAAAAAADgPwAAAAAAAOA/AAAAAAAA4D8CAAAAjAAAAAAAAAAAAAAAQoX0DP///wgAAAAAAAAAAAAAAAAAAAAAAAAAAAAAAAAAAAAAZAAAAAEAAABAAAAAAAAAAAAAAAAAAAAAAAAAAAAAAAAAAAAAAAAAAAAAAAAAAAAAAAAAAAAAAAAAAAAAAAAAAAAAAAAAAAAAAAAAAAAAAAAAAAAAAAAAAAAAAAAAAAAAFAAAADwAAAAAAAAAAAAAAAAAAAkUAAAAAQAAABQAAAAUAAAAFAAAAAEAAAAAAAAAZAAAAGQAAAAAAAAAZAAAAGQAAAAVAAAAYAAAAAAAAAAAAAAADwAAACADAAAAAAAAAAAAAAEAAACgMgAAVgcAAKr4//8BAAAAf39/AAEAAABkAAAAAAAAABQAAABAHwAAAAAAACYAAAAAAAAAwOD//wAAAAAmAAAAZAAAABYAAABMAAAAAAAAAAAAAAAEAAAAAAAAAAEAAABZWVkKAAAAACgAAAAoAAAAZAAAAGQAAAAAAAAAzMzMAAAAAABQAAAAUAAAAGQAAABkAAAAAAAAABcAAAAUAAAAAAAAAAAAAAD/fwAA/38AAAAAAAAJAAAABAAAAAAAAAAeAAAAaAAAAAAAAAAAAAAAAAAAAAAAAAAAAAAAECcAABAnAAAAAAAAAAAAAAAAAAAAAAAAAAAAAAAAAAAAAAAAAAAAABQAAAAAAAAAwMD/AAAAAABkAAAAMgAAAAAAAABkAAAAAAAAAH9/fwAKAAAAIgAAABgAAAAAAAAAAAAAAAAAAAAAAAAAAAAAAAAAAAAkAAAAJAAAAAAAAAAHAAAAAAAAAAAAAAAAAAAAAAAAAAAAAAAAAAAAf39/ACUAAABYAAAAAAAAAAAAAAAAAAAAAAAAAAAAAAAAAAAAAAAAAAAAAAAAAAAAAAAAAAAAAAA/AAAAAAAAAKCGAQAAAAAAAAAAAAAAAAAMAAAAAQAAAAAAAAAAAAAAAAAAAB8AAABUAAAAAAAABQAAAAEAAAAAAAAAAAAAAAAAAAAAAAAAAAAAAAAAAAAAAAAAAAAAAAJ/f38AAAAAA8zMzADAwP8Af39/AAAAAAAAAAAAAAAAAAAAAAAAAAAAIQAAABgAAAAUAAAAHjQAAEAmAAB/NwAAeikAABAAAAAmAAAACAAAADywAAAAAAAA"/>
               </a:ext>
             </a:extLst>
           </p:cNvSpPr>
@@ -4947,7 +4947,7 @@
               </a:spcAft>
               <a:buNone/>
             </a:pPr>
-            <a:fld id="{3FDDB7B3-FDD2-8841-9C65-0B14F92B6A5E}" type="slidenum">
+            <a:fld id="{3B5D0114-5AD6-08F7-98E5-ACA24FAB6EF9}" type="slidenum">
               <a:rPr lang="ru-ru" cap="none"/>
               <a:t/>
             </a:fld>
@@ -4962,7 +4962,7 @@
             <a:spLocks noGrp="1" noChangeArrowheads="1"/>
             <a:extLst>
               <a:ext uri="smNativeData">
-                <pr:smNativeData xmlns:pr="smNativeData" xmlns="smNativeData" val="SMDATA_15_9kV5ZhMAAAAlAAAAZAAAAA0AAAAAkAAAAJAAAACQAAAAkAAAAAAAAAAAAAAAAAAAAAEAAABQAAAAAAAAAAAA4D8AAAAAAADgPwAAAAAAAOA/AAAAAAAA4D8AAAAAAADgPwAAAAAAAOA/AAAAAAAA4D8AAAAAAADgPwAAAAAAAOA/AAAAAAAA4D8CAAAAjAAAAAAAAAAAAAAAQoX0DP///wgAAAAAAAAAAAAAAAAAAAAAAAAAAAAAAAAAAAAAZAAAAAEAAABAAAAAAAAAAAAAAAAAAAAAAAAAAAAAAAAAAAAAAAAAAAAAAAAAAAAAAAAAAAAAAAAAAAAAAAAAAAAAAAAAAAAAAAAAAAAAAAAAAAAAAAAAAAAAAAAAAAAAFAAAADwAAAAAAAAAAAAAAAAAAAkUAAAAAQAAABQAAAAUAAAAFAAAAAEAAAAAAAAAZAAAAGQAAAAAAAAAZAAAAGQAAAAVAAAAYAAAAAAAAAAAAAAADwAAACADAAAAAAAAAAAAAAEAAACgMgAAVgcAAKr4//8BAAAAf39/AAEAAABkAAAAAAAAABQAAABAHwAAAAAAACYAAAAAAAAAwOD//wAAAAAmAAAAZAAAABYAAABMAAAAAAAAAAAAAAAEAAAAAAAAAAEAAABZWVkKAAAAACgAAAAoAAAAZAAAAGQAAAAAAAAAzMzMAAAAAABQAAAAUAAAAGQAAABkAAAAAAAAABcAAAAUAAAAAAAAAAAAAAD/fwAA/38AAAAAAAAJAAAABAAAAF0AXgAeAAAAaAAAAAAAAAAAAAAAAAAAAAAAAAAAAAAAECcAABAnAAAAAAAAAAAAAAAAAAAAAAAAAAAAAAAAAAAAAAAAAAAAABQAAAAAAAAAwMD/AAAAAABkAAAAMgAAAAAAAABkAAAAAAAAAH9/fwAKAAAAIgAAABgAAAAAAAAAAAAAAAAAAAAAAAAAAAAAAAAAAAAkAAAAJAAAAAAAAAAHAAAAAAAAAAAAAAAAAAAAAAAAAAAAAAAAAAAAf39/ACUAAABYAAAAAAAAAAAAAAAAAAAAAAAAAAAAAAAAAAAAAAAAAAAAAAAAAAAAAAAAAAAAAAA/AAAAAAAAAKCGAQAAAAAAAAAAAAAAAAAMAAAAAQAAAAAAAAAAAAAAAAAAAB8AAABUAAAAAAAABQAAAAEAAAAAAAAAAAAAAAAAAAAAAAAAAAAAAAAAAAAAAAAAAAAAAAJ/f38AAAAAA8zMzADAwP8Af39/AAAAAAAAAAAAAAAAAAAAAAAAAAAAIQAAABgAAAAUAAAAFAMAALwGAAB/NwAAARcAABAAAAAmAAAACAAAAD2wAAAAAAAA"/>
+                <pr:smNativeData xmlns:pr="smNativeData" xmlns="smNativeData" val="SMDATA_15_bQt8ZhMAAAAlAAAAZAAAAA0AAAAAkAAAAJAAAACQAAAAkAAAAAAAAAAAAAAAAAAAAAEAAABQAAAAAAAAAAAA4D8AAAAAAADgPwAAAAAAAOA/AAAAAAAA4D8AAAAAAADgPwAAAAAAAOA/AAAAAAAA4D8AAAAAAADgPwAAAAAAAOA/AAAAAAAA4D8CAAAAjAAAAAAAAAAAAAAAQoX0DP///wgAAAAAAAAAAAAAAAAAAAAAAAAAAAAAAAAAAAAAZAAAAAEAAABAAAAAAAAAAAAAAAAAAAAAAAAAAAAAAAAAAAAAAAAAAAAAAAAAAAAAAAAAAAAAAAAAAAAAAAAAAAAAAAAAAAAAAAAAAAAAAAAAAAAAAAAAAAAAAAAAAAAAFAAAADwAAAAAAAAAAAAAAAAAAAkUAAAAAQAAABQAAAAUAAAAFAAAAAEAAAAAAAAAZAAAAGQAAAAAAAAAZAAAAGQAAAAVAAAAYAAAAAAAAAAAAAAADwAAACADAAAAAAAAAAAAAAEAAACgMgAAVgcAAKr4//8BAAAAf39/AAEAAABkAAAAAAAAABQAAABAHwAAAAAAACYAAAAAAAAAwOD//wAAAAAmAAAAZAAAABYAAABMAAAAAAAAAAAAAAAEAAAAAAAAAAEAAABZWVkKAAAAACgAAAAoAAAAZAAAAGQAAAAAAAAAzMzMAAAAAABQAAAAUAAAAGQAAABkAAAAAAAAABcAAAAUAAAAAAAAAAAAAAD/fwAA/38AAAAAAAAJAAAABAAAAF0AXgAeAAAAaAAAAAAAAAAAAAAAAAAAAAAAAAAAAAAAECcAABAnAAAAAAAAAAAAAAAAAAAAAAAAAAAAAAAAAAAAAAAAAAAAABQAAAAAAAAAwMD/AAAAAABkAAAAMgAAAAAAAABkAAAAAAAAAH9/fwAKAAAAIgAAABgAAAAAAAAAAAAAAAAAAAAAAAAAAAAAAAAAAAAkAAAAJAAAAAAAAAAHAAAAAAAAAAAAAAAAAAAAAAAAAAAAAAAAAAAAf39/ACUAAABYAAAAAAAAAAAAAAAAAAAAAAAAAAAAAAAAAAAAAAAAAAAAAAAAAAAAAAAAAAAAAAA/AAAAAAAAAKCGAQAAAAAAAAAAAAAAAAAMAAAAAQAAAAAAAAAAAAAAAAAAAB8AAABUAAAAAAAABQAAAAEAAAAAAAAAAAAAAAAAAAAAAAAAAAAAAAAAAAAAAAAAAAAAAAJ/f38AAAAAA8zMzADAwP8Af39/AAAAAAAAAAAAAAAAAAAAAAAAAAAAIQAAABgAAAAUAAAAFAMAALwGAAB/NwAAARcAABAAAAAmAAAACAAAAD2wAAAAAAAA"/>
               </a:ext>
             </a:extLst>
           </p:cNvSpPr>
@@ -5078,7 +5078,7 @@
             <a:spLocks noGrp="1" noChangeArrowheads="1"/>
             <a:extLst>
               <a:ext uri="smNativeData">
-                <pr:smNativeData xmlns:pr="smNativeData" xmlns="smNativeData" val="SMDATA_15_9kV5ZhMAAAAlAAAAZAAAAA0AAAAAkAAAAJAAAACQAAAAkAAAAAAAAAAAAAAAAAAAAAEAAABQAAAAAAAAAAAA4D8AAAAAAADgPwAAAAAAAOA/AAAAAAAA4D8AAAAAAADgPwAAAAAAAOA/AAAAAAAA4D8AAAAAAADgPwAAAAAAAOA/AAAAAAAA4D8CAAAAjAAAAAAAAAAAAAAAQoX0DP///wgAAAAAAAAAAAAAAAAAAAAAAAAAAAAAAAAAAAAAZAAAAAEAAABAAAAAAAAAAAAAAAAAAAAAAAAAAAAAAAAAAAAAAAAAAAAAAAAAAAAAAAAAAAAAAAAAAAAAAAAAAAAAAAAAAAAAAAAAAAAAAAAAAAAAAAAAAAAAAAAAAAAAFAAAADwAAAAAAAAAAAAAAAAAAAkUAAAAAQAAABQAAAAUAAAAFAAAAAEAAAAAAAAAZAAAAGQAAAAAAAAAZAAAAGQAAAAVAAAAYAAAAAAAAAAAAAAADwAAACADAAAAAAAAAAAAAAEAAACgMgAAVgcAAKr4//8BAAAAf39/AAEAAABkAAAAAAAAABQAAABAHwAAAAAAACYAAAAAAAAAwOD//wAAAAAmAAAAZAAAABYAAABMAAAAAAAAAAAAAAAEAAAAAAAAAAEAAABZWVkKAAAAACgAAAAoAAAAZAAAAGQAAAAAAAAAzMzMAAAAAABQAAAAUAAAAGQAAABkAAAAAAAAABcAAAAUAAAAAAAAAAAAAAD/fwAA/38AAAAAAAAJAAAABAAAAAAAAAAeAAAAaAAAAAAAAAAAAAAAAAAAAAAAAAAAAAAAECcAABAnAAAAAAAAAAAAAAAAAAAAAAAAAAAAAAAAAAAAAAAAAAAAABQAAAAAAAAAwMD/AAAAAABkAAAAMgAAAAAAAABkAAAAAAAAAH9/fwAKAAAAIgAAABgAAAAAAAAAAAAAAAAAAAAAAAAAAAAAAAAAAAAkAAAAJAAAAAAAAAAHAAAAAAAAAAAAAAAAAAAAAAAAAAAAAAAAAAAAf39/ACUAAABYAAAAAAAAAAAAAAAAAAAAAAAAAAAAAAAAAAAAAAAAAAAAAAAAAAAAAAAAAAAAAAA/AAAAAAAAAKCGAQAAAAAAAAAAAAAAAAAMAAAAAQAAAAAAAAAAAAAAAAAAAB8AAABUAAAAAAAABQAAAAEAAAAAAAAAAAAAAAAAAAAAAAAAAAAAAAAAAAAAAAAAAAAAAAJ/f38AAAAAA8zMzADAwP8Af39/AAAAAAAAAAAAAAAAAAAAAAAAAAAAIQAAABgAAAAUAAAAFAMAAMADAAALMwAAQQoAABAAAAAmAAAACAAAAD2wAAAAAAAA"/>
+                <pr:smNativeData xmlns:pr="smNativeData" xmlns="smNativeData" val="SMDATA_15_bQt8ZhMAAAAlAAAAZAAAAA0AAAAAkAAAAJAAAACQAAAAkAAAAAAAAAAAAAAAAAAAAAEAAABQAAAAAAAAAAAA4D8AAAAAAADgPwAAAAAAAOA/AAAAAAAA4D8AAAAAAADgPwAAAAAAAOA/AAAAAAAA4D8AAAAAAADgPwAAAAAAAOA/AAAAAAAA4D8CAAAAjAAAAAAAAAAAAAAAQoX0DP///wgAAAAAAAAAAAAAAAAAAAAAAAAAAAAAAAAAAAAAZAAAAAEAAABAAAAAAAAAAAAAAAAAAAAAAAAAAAAAAAAAAAAAAAAAAAAAAAAAAAAAAAAAAAAAAAAAAAAAAAAAAAAAAAAAAAAAAAAAAAAAAAAAAAAAAAAAAAAAAAAAAAAAFAAAADwAAAAAAAAAAAAAAAAAAAkUAAAAAQAAABQAAAAUAAAAFAAAAAEAAAAAAAAAZAAAAGQAAAAAAAAAZAAAAGQAAAAVAAAAYAAAAAAAAAAAAAAADwAAACADAAAAAAAAAAAAAAEAAACgMgAAVgcAAKr4//8BAAAAf39/AAEAAABkAAAAAAAAABQAAABAHwAAAAAAACYAAAAAAAAAwOD//wAAAAAmAAAAZAAAABYAAABMAAAAAAAAAAAAAAAEAAAAAAAAAAEAAABZWVkKAAAAACgAAAAoAAAAZAAAAGQAAAAAAAAAzMzMAAAAAABQAAAAUAAAAGQAAABkAAAAAAAAABcAAAAUAAAAAAAAAAAAAAD/fwAA/38AAAAAAAAJAAAABAAAAAAAAAAeAAAAaAAAAAAAAAAAAAAAAAAAAAAAAAAAAAAAECcAABAnAAAAAAAAAAAAAAAAAAAAAAAAAAAAAAAAAAAAAAAAAAAAABQAAAAAAAAAwMD/AAAAAABkAAAAMgAAAAAAAABkAAAAAAAAAH9/fwAKAAAAIgAAABgAAAAAAAAAAAAAAAAAAAAAAAAAAAAAAAAAAAAkAAAAJAAAAAAAAAAHAAAAAAAAAAAAAAAAAAAAAAAAAAAAAAAAAAAAf39/ACUAAABYAAAAAAAAAAAAAAAAAAAAAAAAAAAAAAAAAAAAAAAAAAAAAAAAAAAAAAAAAAAAAAA/AAAAAAAAAKCGAQAAAAAAAAAAAAAAAAAMAAAAAQAAAAAAAAAAAAAAAAAAAB8AAABUAAAAAAAABQAAAAEAAAAAAAAAAAAAAAAAAAAAAAAAAAAAAAAAAAAAAAAAAAAAAAJ/f38AAAAAA8zMzADAwP8Af39/AAAAAAAAAAAAAAAAAAAAAAAAAAAAIQAAABgAAAAUAAAAFAMAAMADAAALMwAAQQoAABAAAAAmAAAACAAAAD2wAAAAAAAA"/>
               </a:ext>
             </a:extLst>
           </p:cNvSpPr>
@@ -5265,7 +5265,7 @@
             <a:spLocks noGrp="1" noChangeArrowheads="1"/>
             <a:extLst>
               <a:ext uri="smNativeData">
-                <pr:smNativeData xmlns:pr="smNativeData" xmlns="smNativeData" val="SMDATA_15_9kV5ZhMAAAAlAAAAZAAAAA0AAAAAkAAAAJAAAACQAAAAkAAAAAAAAAAAAAAAAAAAAAEAAABQAAAAAAAAAAAA4D8AAAAAAADgPwAAAAAAAOA/AAAAAAAA4D8AAAAAAADgPwAAAAAAAOA/AAAAAAAA4D8AAAAAAADgPwAAAAAAAOA/AAAAAAAA4D8CAAAAjAAAAAAAAAAAAAAAQoX0DP///wgAAAAAAAAAAAAAAAAAAAAAAAAAAAAAAAAAAAAAZAAAAAEAAABAAAAAAAAAAAAAAAAAAAAAAAAAAAAAAAAAAAAAAAAAAAAAAAAAAAAAAAAAAAAAAAAAAAAAAAAAAAAAAAAAAAAAAAAAAAAAAAAAAAAAAAAAAAAAAAAAAAAAFAAAADwAAAAAAAAAAAAAAAAAAAkUAAAAAQAAABQAAAAUAAAAFAAAAAEAAAAAAAAAZAAAAGQAAAAAAAAAZAAAAGQAAAAVAAAAYAAAAAAAAAAAAAAADwAAACADAAAAAAAAAAAAAAEAAACgMgAAVgcAAKr4//8BAAAAf39/AAEAAABkAAAAAAAAABQAAABAHwAAAAAAACYAAAAAAAAAwOD//wAAAAAmAAAAZAAAABYAAABMAAAAAAAAAAAAAAAEAAAAAAAAAAEAAABZWVkKAAAAACgAAAAoAAAAZAAAAGQAAAAAAAAAzMzMAAAAAABQAAAAUAAAAGQAAABkAAAAAAAAABcAAAAUAAAAAAAAAAAAAAD/fwAA/38AAAAAAAAJAAAABAAAAAAAAAAeAAAAaAAAAAAAAAAAAAAAAAAAAAAAAAAAAAAAECcAABAnAAAAAAAAAAAAAAAAAAAAAAAAAAAAAAAAAAAAAAAAAAAAABQAAAAAAAAAwMD/AAAAAABkAAAAMgAAAAAAAABkAAAAAAAAAH9/fwAKAAAAIgAAABgAAAAAAAAAAAAAAAAAAAAAAAAAAAAAAAAAAAAkAAAAJAAAAAAAAAAHAAAAAAAAAAAAAAAAAAAAAAAAAAAAAAAAAAAAf39/ACUAAABYAAAAAAAAAAAAAAAAAAAAAAAAAAAAAAAAAAAAAAAAAAAAAAAAAAAAAAAAAAAAAAA/AAAAAAAAAKCGAQAAAAAAAAAAAAAAAAAMAAAAAQAAAAAAAAAAAAAAAAAAAB8AAABUAAAAAAAABQAAAAEAAAAAAAAAAAAAAAAAAAAAAAAAAAAAAAAAAAAAAAAAAAAAAAJ/f38AAAAAA8zMzADAwP8Af39/AAAAAAAAAAAAAAAAAAAAAAAAAAAAIQAAABgAAAAUAAAAShMAAK8ZAABQNwAAgB4AABAAAAAmAAAACAAAAD2wAAAAAAAA"/>
+                <pr:smNativeData xmlns:pr="smNativeData" xmlns="smNativeData" val="SMDATA_15_bQt8ZhMAAAAlAAAAZAAAAA0AAAAAkAAAAJAAAACQAAAAkAAAAAAAAAAAAAAAAAAAAAEAAABQAAAAAAAAAAAA4D8AAAAAAADgPwAAAAAAAOA/AAAAAAAA4D8AAAAAAADgPwAAAAAAAOA/AAAAAAAA4D8AAAAAAADgPwAAAAAAAOA/AAAAAAAA4D8CAAAAjAAAAAAAAAAAAAAAQoX0DP///wgAAAAAAAAAAAAAAAAAAAAAAAAAAAAAAAAAAAAAZAAAAAEAAABAAAAAAAAAAAAAAAAAAAAAAAAAAAAAAAAAAAAAAAAAAAAAAAAAAAAAAAAAAAAAAAAAAAAAAAAAAAAAAAAAAAAAAAAAAAAAAAAAAAAAAAAAAAAAAAAAAAAAFAAAADwAAAAAAAAAAAAAAAAAAAkUAAAAAQAAABQAAAAUAAAAFAAAAAEAAAAAAAAAZAAAAGQAAAAAAAAAZAAAAGQAAAAVAAAAYAAAAAAAAAAAAAAADwAAACADAAAAAAAAAAAAAAEAAACgMgAAVgcAAKr4//8BAAAAf39/AAEAAABkAAAAAAAAABQAAABAHwAAAAAAACYAAAAAAAAAwOD//wAAAAAmAAAAZAAAABYAAABMAAAAAAAAAAAAAAAEAAAAAAAAAAEAAABZWVkKAAAAACgAAAAoAAAAZAAAAGQAAAAAAAAAzMzMAAAAAABQAAAAUAAAAGQAAABkAAAAAAAAABcAAAAUAAAAAAAAAAAAAAD/fwAA/38AAAAAAAAJAAAABAAAAAAAAAAeAAAAaAAAAAAAAAAAAAAAAAAAAAAAAAAAAAAAECcAABAnAAAAAAAAAAAAAAAAAAAAAAAAAAAAAAAAAAAAAAAAAAAAABQAAAAAAAAAwMD/AAAAAABkAAAAMgAAAAAAAABkAAAAAAAAAH9/fwAKAAAAIgAAABgAAAAAAAAAAAAAAAAAAAAAAAAAAAAAAAAAAAAkAAAAJAAAAAAAAAAHAAAAAAAAAAAAAAAAAAAAAAAAAAAAAAAAAAAAf39/ACUAAABYAAAAAAAAAAAAAAAAAAAAAAAAAAAAAAAAAAAAAAAAAAAAAAAAAAAAAAAAAAAAAAA/AAAAAAAAAKCGAQAAAAAAAAAAAAAAAAAMAAAAAQAAAAAAAAAAAAAAAAAAAB8AAABUAAAAAAAABQAAAAEAAAAAAAAAAAAAAAAAAAAAAAAAAAAAAAAAAAAAAAAAAAAAAAJ/f38AAAAAA8zMzADAwP8Af39/AAAAAAAAAAAAAAAAAAAAAAAAAAAAIQAAABgAAAAUAAAAShMAAK8ZAABQNwAAgB4AABAAAAAmAAAACAAAAD2wAAAAAAAA"/>
               </a:ext>
             </a:extLst>
           </p:cNvSpPr>
@@ -5452,7 +5452,7 @@
             <a:spLocks noGrp="1" noChangeArrowheads="1"/>
             <a:extLst>
               <a:ext uri="smNativeData">
-                <pr:smNativeData xmlns:pr="smNativeData" xmlns="smNativeData" val="SMDATA_15_9kV5ZhMAAAAlAAAAZAAAAA0AAAAAkAAAAJAAAACQAAAAkAAAAAAAAAAAAAAAAAAAAAEAAABQAAAAAAAAAAAA4D8AAAAAAADgPwAAAAAAAOA/AAAAAAAA4D8AAAAAAADgPwAAAAAAAOA/AAAAAAAA4D8AAAAAAADgPwAAAAAAAOA/AAAAAAAA4D8CAAAAjAAAAAAAAAAAAAAAQoX0DP///wgAAAAAAAAAAAAAAAAAAAAAAAAAAAAAAAAAAAAAZAAAAAEAAABAAAAAAAAAAAAAAAAAAAAAAAAAAAAAAAAAAAAAAAAAAAAAAAAAAAAAAAAAAAAAAAAAAAAAAAAAAAAAAAAAAAAAAAAAAAAAAAAAAAAAAAAAAAAAAAAAAAAAFAAAADwAAAAAAAAAAAAAAAAAAAkUAAAAAQAAABQAAAAUAAAAFAAAAAEAAAAAAAAAZAAAAGQAAAAAAAAAZAAAAGQAAAAVAAAAYAAAAAAAAAAAAAAADwAAACADAAAAAAAAAAAAAAEAAACgMgAAVgcAAKr4//8BAAAAf39/AAEAAABkAAAAAAAAABQAAABAHwAAAAAAACYAAAAAAAAAwOD//wAAAAAmAAAAZAAAABYAAABMAAAAAAAAAAAAAAAEAAAAAAAAAAEAAABZWVkKAAAAACgAAAAoAAAAZAAAAGQAAAAAAAAAzMzMAAAAAABQAAAAUAAAAGQAAABkAAAAAAAAABcAAAAUAAAAAAAAAAAAAAD/fwAA/38AAAAAAAAJAAAABAAAAADvvg8eAAAAaAAAAAAAAAAAAAAAAAAAAAAAAAAAAAAAECcAABAnAAAAAAAAAAAAAAAAAAAAAAAAAAAAAAAAAAAAAAAAAAAAABQAAAAAAAAAwMD/AAAAAABkAAAAMgAAAAAAAABkAAAAAAAAAH9/fwAKAAAAIgAAABgAAAAAAAAAAAAAAAAAAAAAAAAAAAAAAAAAAAAkAAAAJAAAAAAAAAAHAAAAAAAAAAAAAAAAAAAAAAAAAAAAAAAAAAAAf39/ACUAAABYAAAAAAAAAAAAAAAAAAAAAAAAAAAAAAAAAAAAAAAAAAAAAAAAAAAAAAAAAAAAAAA/AAAAAAAAAKCGAQAAAAAAAAAAAAAAAAAMAAAAAQAAAAAAAAAAAAAAAAAAAB8AAABUAAAAAAAABQAAAAEAAAAAAAAAAAAAAAAAAAAAAAAAAAAAAAAAAAAAAAAAAAAAAAJ/f38AAAAAA8zMzADAwP8Af39/AAAAAAAAAAAAAAAAAAAAAAAAAAAAIQAAABgAAAAUAAAAShMAACUcAABQNwAApSIAABAAAAAmAAAACAAAAD2wAAAAAAAA"/>
+                <pr:smNativeData xmlns:pr="smNativeData" xmlns="smNativeData" val="SMDATA_15_bQt8ZhMAAAAlAAAAZAAAAA0AAAAAkAAAAJAAAACQAAAAkAAAAAAAAAAAAAAAAAAAAAEAAABQAAAAAAAAAAAA4D8AAAAAAADgPwAAAAAAAOA/AAAAAAAA4D8AAAAAAADgPwAAAAAAAOA/AAAAAAAA4D8AAAAAAADgPwAAAAAAAOA/AAAAAAAA4D8CAAAAjAAAAAAAAAAAAAAAQoX0DP///wgAAAAAAAAAAAAAAAAAAAAAAAAAAAAAAAAAAAAAZAAAAAEAAABAAAAAAAAAAAAAAAAAAAAAAAAAAAAAAAAAAAAAAAAAAAAAAAAAAAAAAAAAAAAAAAAAAAAAAAAAAAAAAAAAAAAAAAAAAAAAAAAAAAAAAAAAAAAAAAAAAAAAFAAAADwAAAAAAAAAAAAAAAAAAAkUAAAAAQAAABQAAAAUAAAAFAAAAAEAAAAAAAAAZAAAAGQAAAAAAAAAZAAAAGQAAAAVAAAAYAAAAAAAAAAAAAAADwAAACADAAAAAAAAAAAAAAEAAACgMgAAVgcAAKr4//8BAAAAf39/AAEAAABkAAAAAAAAABQAAABAHwAAAAAAACYAAAAAAAAAwOD//wAAAAAmAAAAZAAAABYAAABMAAAAAAAAAAAAAAAEAAAAAAAAAAEAAABZWVkKAAAAACgAAAAoAAAAZAAAAGQAAAAAAAAAzMzMAAAAAABQAAAAUAAAAGQAAABkAAAAAAAAABcAAAAUAAAAAAAAAAAAAAD/fwAA/38AAAAAAAAJAAAABAAAAADvvg8eAAAAaAAAAAAAAAAAAAAAAAAAAAAAAAAAAAAAECcAABAnAAAAAAAAAAAAAAAAAAAAAAAAAAAAAAAAAAAAAAAAAAAAABQAAAAAAAAAwMD/AAAAAABkAAAAMgAAAAAAAABkAAAAAAAAAH9/fwAKAAAAIgAAABgAAAAAAAAAAAAAAAAAAAAAAAAAAAAAAAAAAAAkAAAAJAAAAAAAAAAHAAAAAAAAAAAAAAAAAAAAAAAAAAAAAAAAAAAAf39/ACUAAABYAAAAAAAAAAAAAAAAAAAAAAAAAAAAAAAAAAAAAAAAAAAAAAAAAAAAAAAAAAAAAAA/AAAAAAAAAKCGAQAAAAAAAAAAAAAAAAAMAAAAAQAAAAAAAAAAAAAAAAAAAB8AAABUAAAAAAAABQAAAAEAAAAAAAAAAAAAAAAAAAAAAAAAAAAAAAAAAAAAAAAAAAAAAAJ/f38AAAAAA8zMzADAwP8Af39/AAAAAAAAAAAAAAAAAAAAAAAAAAAAIQAAABgAAAAUAAAAShMAACUcAABQNwAApSIAABAAAAAmAAAACAAAAD2wAAAAAAAA"/>
               </a:ext>
             </a:extLst>
           </p:cNvSpPr>
@@ -5639,7 +5639,7 @@
             <a:spLocks noGrp="1" noChangeArrowheads="1"/>
             <a:extLst>
               <a:ext uri="smNativeData">
-                <pr:smNativeData xmlns:pr="smNativeData" xmlns="smNativeData" val="SMDATA_15_9kV5ZhMAAAAlAAAAZAAAAA0AAAAAkAAAAJAAAACQAAAAkAAAAAAAAAAAAAAAAAAAAAEAAABQAAAAAAAAAAAA4D8AAAAAAADgPwAAAAAAAOA/AAAAAAAA4D8AAAAAAADgPwAAAAAAAOA/AAAAAAAA4D8AAAAAAADgPwAAAAAAAOA/AAAAAAAA4D8CAAAAjAAAAAAAAAAAAAAAQoX0DP///wgAAAAAAAAAAAAAAAAAAAAAAAAAAAAAAAAAAAAAZAAAAAEAAABAAAAAAAAAAAAAAAAAAAAAAAAAAAAAAAAAAAAAAAAAAAAAAAAAAAAAAAAAAAAAAAAAAAAAAAAAAAAAAAAAAAAAAAAAAAAAAAAAAAAAAAAAAAAAAAAAAAAAFAAAADwAAAAAAAAAAAAAAAAAAAkUAAAAAQAAABQAAAAUAAAAFAAAAAEAAAAAAAAAZAAAAGQAAAAAAAAAZAAAAGQAAAAVAAAAYAAAAAAAAAAAAAAADwAAACADAAAAAAAAAAAAAAEAAACgMgAAVgcAAKr4//8BAAAAf39/AAEAAABkAAAAAAAAABQAAABAHwAAAAAAACYAAAAAAAAAwOD//wAAAAAmAAAAZAAAABYAAABMAAAAAAAAAAAAAAAEAAAAAAAAAAEAAABZWVkKAAAAACgAAAAoAAAAZAAAAGQAAAAAAAAAzMzMAAAAAABQAAAAUAAAAGQAAABkAAAAAAAAABcAAAAUAAAAAAAAAAAAAAD/fwAA/38AAAAAAAAJAAAABAAAAIAmcwceAAAAaAAAAAAAAAAAAAAAAAAAAAAAAAAAAAAAECcAABAnAAAAAAAAAAAAAAAAAAAAAAAAAAAAAAAAAAAAAAAAAAAAABQAAAAAAAAAwMD/AAAAAABkAAAAMgAAAAAAAABkAAAAAAAAAH9/fwAKAAAAIgAAABgAAAAAAAAAAAAAAAAAAAAAAAAAAAAAAAAAAAAkAAAAJAAAAAAAAAAHAAAAAAAAAAAAAAAAAAAAAAAAAAAAAAAAAAAAf39/ACUAAABYAAAAAAAAAAAAAAAAAAAAAAAAAAAAAAAAAAAAAAAAAAAAAAAAAAAAAAAAAAAAAAA/AAAAAAAAAKCGAQAAAAAAAAAAAAAAAAAMAAAAAQAAAAAAAAAAAAAAAAAAAB8AAABUAAAAAAAABQAAAAEAAAAAAAAAAAAAAAAAAAAAAAAAAAAAAAAAAAAAAAAAAAAAAAJ/f38AAAAAA8zMzADAwP8Af39/AAAAAAAAAAAAAAAAAAAAAAAAAAAAIQAAABgAAAAUAAAAShMAAEofAABQNwAAwycAABAAAAAmAAAACAAAAD2wAAAAAAAA"/>
+                <pr:smNativeData xmlns:pr="smNativeData" xmlns="smNativeData" val="SMDATA_15_bQt8ZhMAAAAlAAAAZAAAAA0AAAAAkAAAAJAAAACQAAAAkAAAAAAAAAAAAAAAAAAAAAEAAABQAAAAAAAAAAAA4D8AAAAAAADgPwAAAAAAAOA/AAAAAAAA4D8AAAAAAADgPwAAAAAAAOA/AAAAAAAA4D8AAAAAAADgPwAAAAAAAOA/AAAAAAAA4D8CAAAAjAAAAAAAAAAAAAAAQoX0DP///wgAAAAAAAAAAAAAAAAAAAAAAAAAAAAAAAAAAAAAZAAAAAEAAABAAAAAAAAAAAAAAAAAAAAAAAAAAAAAAAAAAAAAAAAAAAAAAAAAAAAAAAAAAAAAAAAAAAAAAAAAAAAAAAAAAAAAAAAAAAAAAAAAAAAAAAAAAAAAAAAAAAAAFAAAADwAAAAAAAAAAAAAAAAAAAkUAAAAAQAAABQAAAAUAAAAFAAAAAEAAAAAAAAAZAAAAGQAAAAAAAAAZAAAAGQAAAAVAAAAYAAAAAAAAAAAAAAADwAAACADAAAAAAAAAAAAAAEAAACgMgAAVgcAAKr4//8BAAAAf39/AAEAAABkAAAAAAAAABQAAABAHwAAAAAAACYAAAAAAAAAwOD//wAAAAAmAAAAZAAAABYAAABMAAAAAAAAAAAAAAAEAAAAAAAAAAEAAABZWVkKAAAAACgAAAAoAAAAZAAAAGQAAAAAAAAAzMzMAAAAAABQAAAAUAAAAGQAAABkAAAAAAAAABcAAAAUAAAAAAAAAAAAAAD/fwAA/38AAAAAAAAJAAAABAAAAIAmcwceAAAAaAAAAAAAAAAAAAAAAAAAAAAAAAAAAAAAECcAABAnAAAAAAAAAAAAAAAAAAAAAAAAAAAAAAAAAAAAAAAAAAAAABQAAAAAAAAAwMD/AAAAAABkAAAAMgAAAAAAAABkAAAAAAAAAH9/fwAKAAAAIgAAABgAAAAAAAAAAAAAAAAAAAAAAAAAAAAAAAAAAAAkAAAAJAAAAAAAAAAHAAAAAAAAAAAAAAAAAAAAAAAAAAAAAAAAAAAAf39/ACUAAABYAAAAAAAAAAAAAAAAAAAAAAAAAAAAAAAAAAAAAAAAAAAAAAAAAAAAAAAAAAAAAAA/AAAAAAAAAKCGAQAAAAAAAAAAAAAAAAAMAAAAAQAAAAAAAAAAAAAAAAAAAB8AAABUAAAAAAAABQAAAAEAAAAAAAAAAAAAAAAAAAAAAAAAAAAAAAAAAAAAAAAAAAAAAAJ/f38AAAAAA8zMzADAwP8Af39/AAAAAAAAAAAAAAAAAAAAAAAAAAAAIQAAABgAAAAUAAAAShMAAEofAABQNwAAwycAABAAAAAmAAAACAAAAD2wAAAAAAAA"/>
               </a:ext>
             </a:extLst>
           </p:cNvSpPr>
@@ -5852,7 +5852,7 @@
             <a:spLocks noGrp="1" noChangeArrowheads="1"/>
             <a:extLst>
               <a:ext uri="smNativeData">
-                <pr:smNativeData xmlns:pr="smNativeData" xmlns="smNativeData" val="SMDATA_15_9kV5ZhMAAAAlAAAAZAAAAA0AAAAAkAAAAJAAAACQAAAAkAAAAAAAAAABAAAAAAAAAAEAAABQAAAAAAAAAAAA4D8AAAAAAADgPwAAAAAAAOA/AAAAAAAA4D8AAAAAAADgPwAAAAAAAOA/AAAAAAAA4D8AAAAAAADgPwAAAAAAAOA/AAAAAAAA4D8CAAAAjAAAAAAAAAAAAAAAQoX0DP///wgAAAAAAAAAAAAAAAAAAAAAAAAAAAAAAAAAAAAAZAAAAAEAAABAAAAAAAAAAAAAAAAAAAAAAAAAAAAAAAAAAAAAAAAAAAAAAAAAAAAAAAAAAAAAAAAAAAAAAAAAAAAAAAAAAAAAAAAAAAAAAAAAAAAAAAAAAAAAAAAAAAAAFAAAADwAAAAAAAAAAAAAAAAAAAkUAAAAAQAAABQAAAAUAAAAFAAAAAEAAAAAAAAAZAAAAGQAAAAAAAAAZAAAAGQAAAAVAAAAYAAAAAAAAAAAAAAADwAAACADAAAAAAAAAAAAAAEAAACgMgAAVgcAAKr4//8BAAAAf39/AAEAAABkAAAAAAAAABQAAABAHwAAAAAAACYAAAAAAAAAwOD//wAAAAAmAAAAZAAAABYAAABMAAAAAAAAAAAAAAAEAAAAAAAAAAEAAABZWVkKAAAAACgAAAAoAAAAZAAAAGQAAAAAAAAAzMzMAAAAAABQAAAAUAAAAGQAAABkAAAAAAAAABcAAAAUAAAAAAAAAAAAAAD/fwAA/38AAAAAAAAJAAAABAAAAF8AYAAeAAAAaAAAAAAAAAAAAAAAAAAAAAAAAAAAAAAAECcAABAnAAAAAAAAAAAAAAAAAAAAAAAAAAAAAAAAAAAAAAAAAAAAABQAAAAAAAAAwMD/AAAAAABkAAAAMgAAAAAAAABkAAAAAAAAAH9/fwAKAAAAIgAAABgAAAAAAAAAAAAAAAAAAAAAAAAAAAAAAAAAAAAkAAAAJAAAAAAAAAAHAAAAAAAAAAAAAAAAAAAAAAAAAAAAAAAAAAAAf39/ACUAAABYAAAAAAAAAAAAAAAAAAAAAAAAAAAAAAAAAAAAAAAAAAAAAAAAAAAAAAAAAAAAAAA/AAAAAAAAAKCGAQAAAAAAAAAAAAAAAAAMAAAAAQAAAAAAAAAAAAAAAAAAAB8AAABUAAAAAAAABQAAAAEAAAAAAAAAAAAAAAAAAAAAAAAAAAAAAAAAAAAAAAAAAAAAAAJ/f38AAAAAA8zMzADAwP8Af39/AAAAAAAAAAAAAAAAAAAAAAAAAAAAIQAAABgAAAAUAAAAHjQAAEAmAAB/NwAAeikAABAAAAAmAAAACAAAADywAAAAAAAA"/>
+                <pr:smNativeData xmlns:pr="smNativeData" xmlns="smNativeData" val="SMDATA_15_bQt8ZhMAAAAlAAAAZAAAAA0AAAAAkAAAAJAAAACQAAAAkAAAAAAAAAABAAAAAAAAAAEAAABQAAAAAAAAAAAA4D8AAAAAAADgPwAAAAAAAOA/AAAAAAAA4D8AAAAAAADgPwAAAAAAAOA/AAAAAAAA4D8AAAAAAADgPwAAAAAAAOA/AAAAAAAA4D8CAAAAjAAAAAAAAAAAAAAAQoX0DP///wgAAAAAAAAAAAAAAAAAAAAAAAAAAAAAAAAAAAAAZAAAAAEAAABAAAAAAAAAAAAAAAAAAAAAAAAAAAAAAAAAAAAAAAAAAAAAAAAAAAAAAAAAAAAAAAAAAAAAAAAAAAAAAAAAAAAAAAAAAAAAAAAAAAAAAAAAAAAAAAAAAAAAFAAAADwAAAAAAAAAAAAAAAAAAAkUAAAAAQAAABQAAAAUAAAAFAAAAAEAAAAAAAAAZAAAAGQAAAAAAAAAZAAAAGQAAAAVAAAAYAAAAAAAAAAAAAAADwAAACADAAAAAAAAAAAAAAEAAACgMgAAVgcAAKr4//8BAAAAf39/AAEAAABkAAAAAAAAABQAAABAHwAAAAAAACYAAAAAAAAAwOD//wAAAAAmAAAAZAAAABYAAABMAAAAAAAAAAAAAAAEAAAAAAAAAAEAAABZWVkKAAAAACgAAAAoAAAAZAAAAGQAAAAAAAAAzMzMAAAAAABQAAAAUAAAAGQAAABkAAAAAAAAABcAAAAUAAAAAAAAAAAAAAD/fwAA/38AAAAAAAAJAAAABAAAAF8AYAAeAAAAaAAAAAAAAAAAAAAAAAAAAAAAAAAAAAAAECcAABAnAAAAAAAAAAAAAAAAAAAAAAAAAAAAAAAAAAAAAAAAAAAAABQAAAAAAAAAwMD/AAAAAABkAAAAMgAAAAAAAABkAAAAAAAAAH9/fwAKAAAAIgAAABgAAAAAAAAAAAAAAAAAAAAAAAAAAAAAAAAAAAAkAAAAJAAAAAAAAAAHAAAAAAAAAAAAAAAAAAAAAAAAAAAAAAAAAAAAf39/ACUAAABYAAAAAAAAAAAAAAAAAAAAAAAAAAAAAAAAAAAAAAAAAAAAAAAAAAAAAAAAAAAAAAA/AAAAAAAAAKCGAQAAAAAAAAAAAAAAAAAMAAAAAQAAAAAAAAAAAAAAAAAAAB8AAABUAAAAAAAABQAAAAEAAAAAAAAAAAAAAAAAAAAAAAAAAAAAAAAAAAAAAAAAAAAAAAJ/f38AAAAAA8zMzADAwP8Af39/AAAAAAAAAAAAAAAAAAAAAAAAAAAAIQAAABgAAAAUAAAAHjQAAEAmAAB/NwAAeikAABAAAAAmAAAACAAAADywAAAAAAAA"/>
               </a:ext>
             </a:extLst>
           </p:cNvSpPr>
@@ -5906,7 +5906,7 @@
               </a:spcAft>
               <a:buNone/>
             </a:pPr>
-            <a:fld id="{3FDDE997-D9D2-881F-9C65-2F4AA72B6A7A}" type="slidenum">
+            <a:fld id="{3B5D4112-5CD6-08B7-98E5-AAE20FAB6EFF}" type="slidenum">
               <a:rPr lang="ru-ru" cap="none"/>
               <a:t/>
             </a:fld>
@@ -5921,7 +5921,7 @@
             <a:spLocks noGrp="1" noChangeArrowheads="1"/>
             <a:extLst>
               <a:ext uri="smNativeData">
-                <pr:smNativeData xmlns:pr="smNativeData" xmlns="smNativeData" val="SMDATA_15_9kV5ZhMAAAAlAAAAZAAAAA0AAAAAkAAAAJAAAACQAAAAkAAAAAAAAAAAAAAAAAAAAAEAAABQAAAAAAAAAAAA4D8AAAAAAADgPwAAAAAAAOA/AAAAAAAA4D8AAAAAAADgPwAAAAAAAOA/AAAAAAAA4D8AAAAAAADgPwAAAAAAAOA/AAAAAAAA4D8CAAAAjAAAAAAAAAAAAAAAQoX0DP///wgAAAAAAAAAAAAAAAAAAAAAAAAAAAAAAAAAAAAAZAAAAAEAAABAAAAAAAAAAAAAAAAAAAAAAAAAAAAAAAAAAAAAAAAAAAAAAAAAAAAAAAAAAAAAAAAAAAAAAAAAAAAAAAAAAAAAAAAAAAAAAAAAAAAAAAAAAAAAAAAAAAAAFAAAADwAAAAAAAAAAAAAAAAAAAkUAAAAAQAAABQAAAAUAAAAFAAAAAEAAAAAAAAAZAAAAGQAAAAAAAAAZAAAAGQAAAAVAAAAYAAAAAAAAAAAAAAADwAAACADAAAAAAAAAAAAAAEAAACgMgAAVgcAAKr4//8BAAAAf39/AAEAAABkAAAAAAAAABQAAABAHwAAAAAAACYAAAAAAAAAwOD//wAAAAAmAAAAZAAAABYAAABMAAAAAAAAAAAAAAAEAAAAAAAAAAEAAABZWVkKAAAAACgAAAAoAAAAZAAAAGQAAAAAAAAAzMzMAAAAAABQAAAAUAAAAGQAAABkAAAAAAAAABcAAAAUAAAAAAAAAAAAAAD/fwAA/38AAAAAAAAJAAAABAAAAADvvg8eAAAAaAAAAAAAAAAAAAAAAAAAAAAAAAAAAAAAECcAABAnAAAAAAAAAAAAAAAAAAAAAAAAAAAAAAAAAAAAAAAAAAAAABQAAAAAAAAAwMD/AAAAAABkAAAAMgAAAAAAAABkAAAAAAAAAH9/fwAKAAAAIgAAABgAAAAAAAAAAAAAAAAAAAAAAAAAAAAAAAAAAAAkAAAAJAAAAAAAAAAHAAAAAAAAAAAAAAAAAAAAAAAAAAAAAAAAAAAAf39/ACUAAABYAAAAAAAAAAAAAAAAAAAAAAAAAAAAAAAAAAAAAAAAAAAAAAAAAAAAAAAAAAAAAAA/AAAAAAAAAKCGAQAAAAAAAAAAAAAAAAAMAAAAAQAAAAAAAAAAAAAAAAAAAB8AAABUAAAAAAAABQAAAAEAAAAAAAAAAAAAAAAAAAAAAAAAAAAAAAAAAAAAAAAAAAAAAAJ/f38AAAAAA8zMzADAwP8Af39/AAAAAAAAAAAAAAAAAAAAAAAAAAAAIQAAABgAAAAUAAAAFAMAALYCAAB/NwAAvwoAABAAAAAmAAAACAAAADywAAAAAAAA"/>
+                <pr:smNativeData xmlns:pr="smNativeData" xmlns="smNativeData" val="SMDATA_15_bQt8ZhMAAAAlAAAAZAAAAA0AAAAAkAAAAJAAAACQAAAAkAAAAAAAAAAAAAAAAAAAAAEAAABQAAAAAAAAAAAA4D8AAAAAAADgPwAAAAAAAOA/AAAAAAAA4D8AAAAAAADgPwAAAAAAAOA/AAAAAAAA4D8AAAAAAADgPwAAAAAAAOA/AAAAAAAA4D8CAAAAjAAAAAAAAAAAAAAAQoX0DP///wgAAAAAAAAAAAAAAAAAAAAAAAAAAAAAAAAAAAAAZAAAAAEAAABAAAAAAAAAAAAAAAAAAAAAAAAAAAAAAAAAAAAAAAAAAAAAAAAAAAAAAAAAAAAAAAAAAAAAAAAAAAAAAAAAAAAAAAAAAAAAAAAAAAAAAAAAAAAAAAAAAAAAFAAAADwAAAAAAAAAAAAAAAAAAAkUAAAAAQAAABQAAAAUAAAAFAAAAAEAAAAAAAAAZAAAAGQAAAAAAAAAZAAAAGQAAAAVAAAAYAAAAAAAAAAAAAAADwAAACADAAAAAAAAAAAAAAEAAACgMgAAVgcAAKr4//8BAAAAf39/AAEAAABkAAAAAAAAABQAAABAHwAAAAAAACYAAAAAAAAAwOD//wAAAAAmAAAAZAAAABYAAABMAAAAAAAAAAAAAAAEAAAAAAAAAAEAAABZWVkKAAAAACgAAAAoAAAAZAAAAGQAAAAAAAAAzMzMAAAAAABQAAAAUAAAAGQAAABkAAAAAAAAABcAAAAUAAAAAAAAAAAAAAD/fwAA/38AAAAAAAAJAAAABAAAAADvvg8eAAAAaAAAAAAAAAAAAAAAAAAAAAAAAAAAAAAAECcAABAnAAAAAAAAAAAAAAAAAAAAAAAAAAAAAAAAAAAAAAAAAAAAABQAAAAAAAAAwMD/AAAAAABkAAAAMgAAAAAAAABkAAAAAAAAAH9/fwAKAAAAIgAAABgAAAAAAAAAAAAAAAAAAAAAAAAAAAAAAAAAAAAkAAAAJAAAAAAAAAAHAAAAAAAAAAAAAAAAAAAAAAAAAAAAAAAAAAAAf39/ACUAAABYAAAAAAAAAAAAAAAAAAAAAAAAAAAAAAAAAAAAAAAAAAAAAAAAAAAAAAAAAAAAAAA/AAAAAAAAAKCGAQAAAAAAAAAAAAAAAAAMAAAAAQAAAAAAAAAAAAAAAAAAAB8AAABUAAAAAAAABQAAAAEAAAAAAAAAAAAAAAAAAAAAAAAAAAAAAAAAAAAAAAAAAAAAAAJ/f38AAAAAA8zMzADAwP8Af39/AAAAAAAAAAAAAAAAAAAAAAAAAAAAIQAAABgAAAAUAAAAFAMAALYCAAB/NwAAvwoAABAAAAAmAAAACAAAADywAAAAAAAA"/>
               </a:ext>
             </a:extLst>
           </p:cNvSpPr>
@@ -6031,7 +6031,7 @@
             <a:spLocks noGrp="1" noChangeArrowheads="1"/>
             <a:extLst>
               <a:ext uri="smNativeData">
-                <pr:smNativeData xmlns:pr="smNativeData" xmlns="smNativeData" val="SMDATA_15_9kV5ZhMAAAAlAAAAZAAAAE0AAAAAkAAAAJAAAACQAAAAkAAAAAAAAAAAAAAAAAAAAAEAAABQAAAAAAAAAAAA4D8AAAAAAADgPwAAAAAAAOA/AAAAAAAA4D8AAAAAAADgPwAAAAAAAOA/AAAAAAAA4D8AAAAAAADgPwAAAAAAAOA/AAAAAAAA4D8CAAAAjAAAAAAAAAAAAAAAQoX0DP///wgAAAAAAAAAAAAAAAAAAAAAAAAAAAAAAAAAAAAAZAAAAAEAAABAAAAAAAAAAAAAAAAAAAAAAAAAAAAAAAAAAAAAAAAAAAAAAAAAAAAAAAAAAAAAAAAAAAAAAAAAAAAAAAAAAAAAAAAAAAAAAAAAAAAAAAAAAAAAAAAAAAAAFAAAADwAAAAAAAAAAAAAAAAAAAkUAAAAAQAAABQAAAAUAAAAFAAAAAEAAAAAAAAAZAAAAGQAAAAAAAAAZAAAAGQAAAAVAAAAYAAAAAAAAAAAAAAADwAAACADAAAAAAAAAAAAAAEAAACgMgAAVgcAAKr4//8BAAAAf39/AAEAAABkAAAAAAAAABQAAABAHwAAAAAAACYAAAAAAAAAwOD//wAAAAAmAAAAZAAAABYAAABMAAAAAAAAAAAAAAAEAAAAAAAAAAEAAABZWVkKAAAAACgAAAAoAAAAZAAAAGQAAAAAAAAAzMzMAAAAAABQAAAAUAAAAGQAAABkAAAAAAAAABcAAAAUAAAAAAAAAAAAAAD/fwAA/38AAAAAAAAJAAAABAAAAGdlODkeAAAAaAAAAAAAAAAAAAAAAAAAAAAAAAAAAAAAECcAABAnAAAAAAAAAAAAAAAAAAAAAAAAAAAAAAAAAAAAAAAAAAAAABQAAAAAAAAAwMD/AAAAAABkAAAAMgAAAAAAAABkAAAAAAAAAH9/fwAKAAAAIgAAABgAAAAAAAAAAAAAAAAAAAAAAAAAAAAAAAAAAAAkAAAAJAAAAAAAAAAHAAAAAAAAAAAAAAAAAAAAAAAAAAAAAAAAAAAAf39/ACUAAABYAAAAAAAAAAAAAAAAAAAAAAAAAAAAAAAAAAAAAAAAAAAAAAAAAAAAAAAAAAAAAAA/AAAAAAAAAKCGAQAAAAAAAAAAAAAAAAAMAAAAAQAAAAAAAAAAAAAAAAAAAB8AAABUAAAAAAAABQAAAAEAAAAAAAAAAAAAAAAAAAAAAAAAAAAAAAAAAAAAAAAAAAAAAAJ/f38AAAAAA8zMzADAwP8Af39/AAAAAAAAAAAAAAAAAAAAAAAAAAAAIQAAABgAAAAUAAAAXAgAALAKAAAUJAAAtiYAABAgAAAmAAAACAAAAD2wAAAAAAAA"/>
+                <pr:smNativeData xmlns:pr="smNativeData" xmlns="smNativeData" val="SMDATA_15_bQt8ZhMAAAAlAAAAZAAAAE0AAAAAkAAAAJAAAACQAAAAkAAAAAAAAAAAAAAAAAAAAAEAAABQAAAAAAAAAAAA4D8AAAAAAADgPwAAAAAAAOA/AAAAAAAA4D8AAAAAAADgPwAAAAAAAOA/AAAAAAAA4D8AAAAAAADgPwAAAAAAAOA/AAAAAAAA4D8CAAAAjAAAAAAAAAAAAAAAQoX0DP///wgAAAAAAAAAAAAAAAAAAAAAAAAAAAAAAAAAAAAAZAAAAAEAAABAAAAAAAAAAAAAAAAAAAAAAAAAAAAAAAAAAAAAAAAAAAAAAAAAAAAAAAAAAAAAAAAAAAAAAAAAAAAAAAAAAAAAAAAAAAAAAAAAAAAAAAAAAAAAAAAAAAAAFAAAADwAAAAAAAAAAAAAAAAAAAkUAAAAAQAAABQAAAAUAAAAFAAAAAEAAAAAAAAAZAAAAGQAAAAAAAAAZAAAAGQAAAAVAAAAYAAAAAAAAAAAAAAADwAAACADAAAAAAAAAAAAAAEAAACgMgAAVgcAAKr4//8BAAAAf39/AAEAAABkAAAAAAAAABQAAABAHwAAAAAAACYAAAAAAAAAwOD//wAAAAAmAAAAZAAAABYAAABMAAAAAAAAAAAAAAAEAAAAAAAAAAEAAABZWVkKAAAAACgAAAAoAAAAZAAAAGQAAAAAAAAAzMzMAAAAAABQAAAAUAAAAGQAAABkAAAAAAAAABcAAAAUAAAAAAAAAAAAAAD/fwAA/38AAAAAAAAJAAAABAAAAGdlODkeAAAAaAAAAAAAAAAAAAAAAAAAAAAAAAAAAAAAECcAABAnAAAAAAAAAAAAAAAAAAAAAAAAAAAAAAAAAAAAAAAAAAAAABQAAAAAAAAAwMD/AAAAAABkAAAAMgAAAAAAAABkAAAAAAAAAH9/fwAKAAAAIgAAABgAAAAAAAAAAAAAAAAAAAAAAAAAAAAAAAAAAAAkAAAAJAAAAAAAAAAHAAAAAAAAAAAAAAAAAAAAAAAAAAAAAAAAAAAAf39/ACUAAABYAAAAAAAAAAAAAAAAAAAAAAAAAAAAAAAAAAAAAAAAAAAAAAAAAAAAAAAAAAAAAAA/AAAAAAAAAKCGAQAAAAAAAAAAAAAAAAAMAAAAAQAAAAAAAAAAAAAAAAAAAB8AAABUAAAAAAAABQAAAAEAAAAAAAAAAAAAAAAAAAAAAAAAAAAAAAAAAAAAAAAAAAAAAAJ/f38AAAAAA8zMzADAwP8Af39/AAAAAAAAAAAAAAAAAAAAAAAAAAAAIQAAABgAAAAUAAAAXAgAALAKAAAUJAAAtiYAABAgAAAmAAAACAAAAD2wAAAAAAAA"/>
               </a:ext>
             </a:extLst>
           </p:cNvSpPr>
@@ -6224,7 +6224,7 @@
             <a:spLocks noGrp="1" noChangeArrowheads="1"/>
             <a:extLst>
               <a:ext uri="smNativeData">
-                <pr:smNativeData xmlns:pr="smNativeData" xmlns="smNativeData" val="SMDATA_15_9kV5ZhMAAAAlAAAAZAAAAA0AAAAAkAAAAJAAAACQAAAAkAAAAAAAAAABAAAAAAAAAAEAAABQAAAAAAAAAAAA4D8AAAAAAADgPwAAAAAAAOA/AAAAAAAA4D8AAAAAAADgPwAAAAAAAOA/AAAAAAAA4D8AAAAAAADgPwAAAAAAAOA/AAAAAAAA4D8CAAAAjAAAAAAAAAAAAAAAQoX0DP///wgAAAAAAAAAAAAAAAAAAAAAAAAAAAAAAAAAAAAAZAAAAAEAAABAAAAAAAAAAAAAAAAAAAAAAAAAAAAAAAAAAAAAAAAAAAAAAAAAAAAAAAAAAAAAAAAAAAAAAAAAAAAAAAAAAAAAAAAAAAAAAAAAAAAAAAAAAAAAAAAAAAAAFAAAADwAAAAAAAAAAAAAAAAAAAkUAAAAAQAAABQAAAAUAAAAFAAAAAEAAAAAAAAAZAAAAGQAAAAAAAAAZAAAAGQAAAAVAAAAYAAAAAAAAAAAAAAADwAAACADAAAAAAAAAAAAAAEAAACgMgAAVgcAAKr4//8BAAAAf39/AAEAAABkAAAAAAAAABQAAABAHwAAAAAAACYAAAAAAAAAwOD//wAAAAAmAAAAZAAAABYAAABMAAAAAAAAAAAAAAAEAAAAAAAAAAEAAABZWVkKAAAAACgAAAAoAAAAZAAAAGQAAAAAAAAAzMzMAAAAAABQAAAAUAAAAGQAAABkAAAAAAAAABcAAAAUAAAAAAAAAAAAAAD/fwAA/38AAAAAAAAJAAAABAAAAAAAAAAeAAAAaAAAAAAAAAAAAAAAAAAAAAAAAAAAAAAAECcAABAnAAAAAAAAAAAAAAAAAAAAAAAAAAAAAAAAAAAAAAAAAAAAABQAAAAAAAAAwMD/AAAAAABkAAAAMgAAAAAAAABkAAAAAAAAAH9/fwAKAAAAIgAAABgAAAAAAAAAAAAAAAAAAAAAAAAAAAAAAAAAAAAkAAAAJAAAAAAAAAAHAAAAAAAAAAAAAAAAAAAAAAAAAAAAAAAAAAAAf39/ACUAAABYAAAAAAAAAAAAAAAAAAAAAAAAAAAAAAAAAAAAAAAAAAAAAAAAAAAAAAAAAAAAAAA/AAAAAAAAAKCGAQAAAAAAAAAAAAAAAAAMAAAAAQAAAAAAAAAAAAAAAAAAAB8AAABUAAAAAAAABQAAAAEAAAAAAAAAAAAAAAAAAAAAAAAAAAAAAAAAAAAAAAAAAAAAAAJ/f38AAAAAA8zMzADAwP8Af39/AAAAAAAAAAAAAAAAAAAAAAAAAAAAIQAAABgAAAAUAAAAHjQAAEAmAAB/NwAAeikAABAAAAAmAAAACAAAADywAAAAAAAA"/>
+                <pr:smNativeData xmlns:pr="smNativeData" xmlns="smNativeData" val="SMDATA_15_bQt8ZhMAAAAlAAAAZAAAAA0AAAAAkAAAAJAAAACQAAAAkAAAAAAAAAABAAAAAAAAAAEAAABQAAAAAAAAAAAA4D8AAAAAAADgPwAAAAAAAOA/AAAAAAAA4D8AAAAAAADgPwAAAAAAAOA/AAAAAAAA4D8AAAAAAADgPwAAAAAAAOA/AAAAAAAA4D8CAAAAjAAAAAAAAAAAAAAAQoX0DP///wgAAAAAAAAAAAAAAAAAAAAAAAAAAAAAAAAAAAAAZAAAAAEAAABAAAAAAAAAAAAAAAAAAAAAAAAAAAAAAAAAAAAAAAAAAAAAAAAAAAAAAAAAAAAAAAAAAAAAAAAAAAAAAAAAAAAAAAAAAAAAAAAAAAAAAAAAAAAAAAAAAAAAFAAAADwAAAAAAAAAAAAAAAAAAAkUAAAAAQAAABQAAAAUAAAAFAAAAAEAAAAAAAAAZAAAAGQAAAAAAAAAZAAAAGQAAAAVAAAAYAAAAAAAAAAAAAAADwAAACADAAAAAAAAAAAAAAEAAACgMgAAVgcAAKr4//8BAAAAf39/AAEAAABkAAAAAAAAABQAAABAHwAAAAAAACYAAAAAAAAAwOD//wAAAAAmAAAAZAAAABYAAABMAAAAAAAAAAAAAAAEAAAAAAAAAAEAAABZWVkKAAAAACgAAAAoAAAAZAAAAGQAAAAAAAAAzMzMAAAAAABQAAAAUAAAAGQAAABkAAAAAAAAABcAAAAUAAAAAAAAAAAAAAD/fwAA/38AAAAAAAAJAAAABAAAAAAAAAAeAAAAaAAAAAAAAAAAAAAAAAAAAAAAAAAAAAAAECcAABAnAAAAAAAAAAAAAAAAAAAAAAAAAAAAAAAAAAAAAAAAAAAAABQAAAAAAAAAwMD/AAAAAABkAAAAMgAAAAAAAABkAAAAAAAAAH9/fwAKAAAAIgAAABgAAAAAAAAAAAAAAAAAAAAAAAAAAAAAAAAAAAAkAAAAJAAAAAAAAAAHAAAAAAAAAAAAAAAAAAAAAAAAAAAAAAAAAAAAf39/ACUAAABYAAAAAAAAAAAAAAAAAAAAAAAAAAAAAAAAAAAAAAAAAAAAAAAAAAAAAAAAAAAAAAA/AAAAAAAAAKCGAQAAAAAAAAAAAAAAAAAMAAAAAQAAAAAAAAAAAAAAAAAAAB8AAABUAAAAAAAABQAAAAEAAAAAAAAAAAAAAAAAAAAAAAAAAAAAAAAAAAAAAAAAAAAAAAJ/f38AAAAAA8zMzADAwP8Af39/AAAAAAAAAAAAAAAAAAAAAAAAAAAAIQAAABgAAAAUAAAAHjQAAEAmAAB/NwAAeikAABAAAAAmAAAACAAAADywAAAAAAAA"/>
               </a:ext>
             </a:extLst>
           </p:cNvSpPr>
@@ -6278,7 +6278,7 @@
               </a:spcAft>
               <a:buNone/>
             </a:pPr>
-            <a:fld id="{3FDD8E34-7AD2-8878-9C65-8C2DC02B6AD9}" type="slidenum">
+            <a:fld id="{3B5D53EA-A4D6-08A5-98E5-52F01DAB6E07}" type="slidenum">
               <a:rPr lang="ru-ru" cap="none"/>
               <a:t/>
             </a:fld>
@@ -6292,7 +6292,7 @@
           <p:cNvPicPr>
             <a:extLst>
               <a:ext uri="smNativeData">
-                <pr:smNativeData xmlns:pr="smNativeData" xmlns="smNativeData" val="SMDATA_17_9kV5ZhMAAAAlAAAAEQAAAA0AAAAAkAAAAEgAAACQAAAASAAAAAAAAAAAAAAAAAAAAAEAAABQAAAAAAAAAAAA4D8AAAAAAADgPwAAAAAAAOA/AAAAAAAA4D8AAAAAAADgPwAAAAAAAOA/AAAAAAAA4D8AAAAAAADgPwAAAAAAAOA/AAAAAAAA4D8CAAAAjAAAAAAAAAAAAAAAQoX0DP///wgAAAAAAAAAAAAAAAAAAAAAAAAAAAAAAAAAAAAAZAAAAAEAAABAAAAAAAAAAAAAAAAAAAAAAAAAAAAAAAAAAAAAAAAAAAAAAAAAAAAAAAAAAAAAAAAAAAAAAAAAAAAAAAAAAAAAAAAAAAAAAAAAAAAAAAAAAAAAAAAAAAAAFAAAADwAAAAAAAAAAAAAAAAAAAkUAAAAAQAAABQAAAAUAAAAFAAAAAEAAAAAAAAAZAAAAGQAAAAAAAAAZAAAAGQAAAAVAAAAYAAAAAAAAAAAAAAADwAAACADAAAAAAAAAAAAAAEAAACgMgAAVgcAAKr4//8BAAAAf39/AAEAAABkAAAAAAAAABQAAABAHwAAAAAAACYAAAAAAAAAwOD//wAAAAAmAAAAZAAAABYAAABMAAAAAAAAAAAAAAAEAAAAAAAAAAEAAABZWVkKAAAAACgAAAAoAAAAZAAAAGQAAAAAAAAAzMzMAAAAAABQAAAAUAAAAGQAAABkAAAAAAAAAAcAAAA4AAAAAAAAAAAAAAAAAAAA////AAAAAAAAAAAAAAAAAAAAAAAAAAAAAAAAAAAAAABkAAAAZAAAAAAAAAAjAAAABAAAAGQAAAAXAAAAFAAAAAAAAAAAAAAA/38AAP9/AAAAAAAACQAAAAQAAACwmIhjHgAAAGgAAAAAAAAAAAAAAAAAAAAAAAAAAAAAABAnAAAQJwAAAAAAAAAAAAAAAAAAAAAAAAAAAAAAAAAAAAAAAAAAAAAUAAAAAAAAAMDA/wAAAAAAZAAAADIAAAAAAAAAZAAAAAAAAAB/f38ACgAAACIAAAAYAAAAAAAAAAAAAAAAAAAAAAAAAAAAAAAAAAAAJAAAACQAAAAAAAAABwAAAAAAAAAAAAAAAAAAAAAAAAAAAAAAAAAAAH9/fwAlAAAAWAAAAAAAAAAAAAAAAAAAAAAAAAAAAAAAAAAAAAAAAAAAAAAAAAAAAAAAAAAAAAAAPwAAAAAAAACghgEAAAAAAAAAAAAAAAAADAAAAAEAAAAAAAAAAAAAAAAAAAAfAAAAVAAAAEKF9AX///8BAAAAAAAAAAAAAAAAAAAAAAAAAAAAAAAAAAAAAAAAAAAAAAACf39/AFlZWQPMzMwAwMD/AH9/fwAAAAAAAAAAAAAAAAD///8AAAAAACEAAAAYAAAAFAAAAAAAAAAAAAAAQDgAADAqAAAQAAAAJgAAAAgAAAD//////////w=="/>
+                <pr:smNativeData xmlns:pr="smNativeData" xmlns="smNativeData" val="SMDATA_17_bQt8ZhMAAAAlAAAAEQAAAA0AAAAAkAAAAEgAAACQAAAASAAAAAAAAAAAAAAAAAAAAAEAAABQAAAAAAAAAAAA4D8AAAAAAADgPwAAAAAAAOA/AAAAAAAA4D8AAAAAAADgPwAAAAAAAOA/AAAAAAAA4D8AAAAAAADgPwAAAAAAAOA/AAAAAAAA4D8CAAAAjAAAAAAAAAAAAAAAQoX0DP///wgAAAAAAAAAAAAAAAAAAAAAAAAAAAAAAAAAAAAAZAAAAAEAAABAAAAAAAAAAAAAAAAAAAAAAAAAAAAAAAAAAAAAAAAAAAAAAAAAAAAAAAAAAAAAAAAAAAAAAAAAAAAAAAAAAAAAAAAAAAAAAAAAAAAAAAAAAAAAAAAAAAAAFAAAADwAAAAAAAAAAAAAAAAAAAkUAAAAAQAAABQAAAAUAAAAFAAAAAEAAAAAAAAAZAAAAGQAAAAAAAAAZAAAAGQAAAAVAAAAYAAAAAAAAAAAAAAADwAAACADAAAAAAAAAAAAAAEAAACgMgAAVgcAAKr4//8BAAAAf39/AAEAAABkAAAAAAAAABQAAABAHwAAAAAAACYAAAAAAAAAwOD//wAAAAAmAAAAZAAAABYAAABMAAAAAAAAAAAAAAAEAAAAAAAAAAEAAABZWVkKAAAAACgAAAAoAAAAZAAAAGQAAAAAAAAAzMzMAAAAAABQAAAAUAAAAGQAAABkAAAAAAAAAAcAAAA4AAAAAAAAAAAAAAAAAAAA////AAAAAAAAAAAAAAAAAAAAAAAAAAAAAAAAAAAAAABkAAAAZAAAAAAAAAAjAAAABAAAAGQAAAAXAAAAFAAAAAAAAAAAAAAA/38AAP9/AAAAAAAACQAAAAQAAACwmIhjHgAAAGgAAAAAAAAAAAAAAAAAAAAAAAAAAAAAABAnAAAQJwAAAAAAAAAAAAAAAAAAAAAAAAAAAAAAAAAAAAAAAAAAAAAUAAAAAAAAAMDA/wAAAAAAZAAAADIAAAAAAAAAZAAAAAAAAAB/f38ACgAAACIAAAAYAAAAAAAAAAAAAAAAAAAAAAAAAAAAAAAAAAAAJAAAACQAAAAAAAAABwAAAAAAAAAAAAAAAAAAAAAAAAAAAAAAAAAAAH9/fwAlAAAAWAAAAAAAAAAAAAAAAAAAAAAAAAAAAAAAAAAAAAAAAAAAAAAAAAAAAAAAAAAAAAAAPwAAAAAAAACghgEAAAAAAAAAAAAAAAAADAAAAAEAAAAAAAAAAAAAAAAAAAAfAAAAVAAAAEKF9AX///8BAAAAAAAAAAAAAAAAAAAAAAAAAAAAAAAAAAAAAAAAAAAAAAACf39/AFlZWQPMzMwAwMD/AH9/fwAAAAAAAAAAAAAAAAD///8AAAAAACEAAAAYAAAAFAAAAAAAAAAAAAAAQDgAADAqAAAQAAAAJgAAAAgAAAD//////////w=="/>
               </a:ext>
             </a:extLst>
           </p:cNvPicPr>
@@ -6326,7 +6326,7 @@
             <a:spLocks noGrp="1" noChangeArrowheads="1"/>
             <a:extLst>
               <a:ext uri="smNativeData">
-                <pr:smNativeData xmlns:pr="smNativeData" xmlns="smNativeData" val="SMDATA_15_9kV5ZhMAAAAlAAAAZAAAAA0AAAAAkAAAAJAAAACQAAAAkAAAAAAAAAABAAAAAAAAAAEAAABQAAAAAAAAAAAA4D8AAAAAAADgPwAAAAAAAOA/AAAAAAAA4D8AAAAAAADgPwAAAAAAAOA/AAAAAAAA4D8AAAAAAADgPwAAAAAAAOA/AAAAAAAA4D8CAAAAjAAAAAAAAAAAAAAAQoX0DP///wgAAAAAAAAAAAAAAAAAAAAAAAAAAAAAAAAAAAAAZAAAAAEAAABAAAAAAAAAAAAAAAAAAAAAAAAAAAAAAAAAAAAAAAAAAAAAAAAAAAAAAAAAAAAAAAAAAAAAAAAAAAAAAAAAAAAAAAAAAAAAAAAAAAAAAAAAAAAAAAAAAAAAFAAAADwAAAAAAAAAAAAAAAAAAAkUAAAAAQAAABQAAAAUAAAAFAAAAAEAAAAAAAAAZAAAAGQAAAAAAAAAZAAAAGQAAAAVAAAAYAAAAAAAAAAAAAAADwAAACADAAAAAAAAAAAAAAEAAACgMgAAVgcAAKr4//8BAAAAf39/AAEAAABkAAAAAAAAABQAAABAHwAAAAAAACYAAAAAAAAAwOD//wAAAAAmAAAAZAAAABYAAABMAAAAAAAAAAAAAAAEAAAAAAAAAAEAAABZWVkKAAAAACgAAAAoAAAAZAAAAGQAAAAAAAAAzMzMAAAAAABQAAAAUAAAAGQAAABkAAAAAAAAABcAAAAUAAAAAAAAAAAAAAD/fwAA/38AAAAAAAAJAAAABAAAAG0AOwAeAAAAaAAAAAAAAAAAAAAAAAAAAAAAAAAAAAAAECcAABAnAAAAAAAAAAAAAAAAAAAAAAAAAAAAAAAAAAAAAAAAAAAAABQAAAAAAAAAwMD/AAAAAABkAAAAMgAAAAAAAABkAAAAAAAAAH9/fwAKAAAAIgAAABgAAAAAAAAAAAAAAAAAAAAAAAAAAAAAAAAAAAAkAAAAJAAAAAAAAAAHAAAAAAAAAAAAAAAAAAAAAAAAAAAAAAAAAAAAf39/ACUAAABYAAAAAAAAAAAAAAAAAAAAAAAAAAAAAAAAAAAAAAAAAAAAAAAAAAAAAAAAAAAAAAA/AAAAAAAAAKCGAQAAAAAAAAAAAAAAAAAMAAAAAQAAAAAAAAAAAAAAAAAAAB8AAABUAAAAAAAABQAAAAEAAAAAAAAAAAAAAAAAAAAAAAAAAAAAAAAAAAAAAAAAAAAAAAJ/f38AAAAAA8zMzADAwP8Af39/AAAAAAAAAAAAAAAAAAAAAAAAAAAAIQAAABgAAAAUAAAA4gUAAEADAAA5NQAAziQAABAAAAAmAAAACAAAAL2wAAAAAAAA"/>
+                <pr:smNativeData xmlns:pr="smNativeData" xmlns="smNativeData" val="SMDATA_15_bQt8ZhMAAAAlAAAAZAAAAA0AAAAAkAAAAJAAAACQAAAAkAAAAAAAAAABAAAAAAAAAAEAAABQAAAAAAAAAAAA4D8AAAAAAADgPwAAAAAAAOA/AAAAAAAA4D8AAAAAAADgPwAAAAAAAOA/AAAAAAAA4D8AAAAAAADgPwAAAAAAAOA/AAAAAAAA4D8CAAAAjAAAAAAAAAAAAAAAQoX0DP///wgAAAAAAAAAAAAAAAAAAAAAAAAAAAAAAAAAAAAAZAAAAAEAAABAAAAAAAAAAAAAAAAAAAAAAAAAAAAAAAAAAAAAAAAAAAAAAAAAAAAAAAAAAAAAAAAAAAAAAAAAAAAAAAAAAAAAAAAAAAAAAAAAAAAAAAAAAAAAAAAAAAAAFAAAADwAAAAAAAAAAAAAAAAAAAkUAAAAAQAAABQAAAAUAAAAFAAAAAEAAAAAAAAAZAAAAGQAAAAAAAAAZAAAAGQAAAAVAAAAYAAAAAAAAAAAAAAADwAAACADAAAAAAAAAAAAAAEAAACgMgAAVgcAAKr4//8BAAAAf39/AAEAAABkAAAAAAAAABQAAABAHwAAAAAAACYAAAAAAAAAwOD//wAAAAAmAAAAZAAAABYAAABMAAAAAAAAAAAAAAAEAAAAAAAAAAEAAABZWVkKAAAAACgAAAAoAAAAZAAAAGQAAAAAAAAAzMzMAAAAAABQAAAAUAAAAGQAAABkAAAAAAAAABcAAAAUAAAAAAAAAAAAAAD/fwAA/38AAAAAAAAJAAAABAAAAG0AOwAeAAAAaAAAAAAAAAAAAAAAAAAAAAAAAAAAAAAAECcAABAnAAAAAAAAAAAAAAAAAAAAAAAAAAAAAAAAAAAAAAAAAAAAABQAAAAAAAAAwMD/AAAAAABkAAAAMgAAAAAAAABkAAAAAAAAAH9/fwAKAAAAIgAAABgAAAAAAAAAAAAAAAAAAAAAAAAAAAAAAAAAAAAkAAAAJAAAAAAAAAAHAAAAAAAAAAAAAAAAAAAAAAAAAAAAAAAAAAAAf39/ACUAAABYAAAAAAAAAAAAAAAAAAAAAAAAAAAAAAAAAAAAAAAAAAAAAAAAAAAAAAAAAAAAAAA/AAAAAAAAAKCGAQAAAAAAAAAAAAAAAAAMAAAAAQAAAAAAAAAAAAAAAAAAAB8AAABUAAAAAAAABQAAAAEAAAAAAAAAAAAAAAAAAAAAAAAAAAAAAAAAAAAAAAAAAAAAAAJ/f38AAAAAA8zMzADAwP8Af39/AAAAAAAAAAAAAAAAAAAAAAAAAAAAIQAAABgAAAAUAAAA4gUAAEADAAA5NQAAziQAABAAAAAmAAAACAAAAL2wAAAAAAAA"/>
               </a:ext>
             </a:extLst>
           </p:cNvSpPr>
@@ -6480,7 +6480,7 @@
             <a:spLocks noGrp="1" noChangeArrowheads="1"/>
             <a:extLst>
               <a:ext uri="smNativeData">
-                <pr:smNativeData xmlns:pr="smNativeData" xmlns="smNativeData" val="SMDATA_15_9kV5ZhMAAAAlAAAAZAAAAA0AAAAAkAAAAJAAAACQAAAAkAAAAAAAAAAAAAAAAAAAAAEAAABQAAAAAAAAAAAA4D8AAAAAAADgPwAAAAAAAOA/AAAAAAAA4D8AAAAAAADgPwAAAAAAAOA/AAAAAAAA4D8AAAAAAADgPwAAAAAAAOA/AAAAAAAA4D8CAAAAjAAAAAAAAAAAAAAAQoX0DP///wgAAAAAAAAAAAAAAAAAAAAAAAAAAAAAAAAAAAAAZAAAAAEAAABAAAAAAAAAAAAAAAAAAAAAAAAAAAAAAAAAAAAAAAAAAAAAAAAAAAAAAAAAAAAAAAAAAAAAAAAAAAAAAAAAAAAAAAAAAAAAAAAAAAAAAAAAAAAAAAAAAAAAFAAAADwAAAAAAAAAAAAAAAAAAAkUAAAAAQAAABQAAAAUAAAAFAAAAAEAAAAAAAAAZAAAAGQAAAAAAAAAZAAAAGQAAAAVAAAAYAAAAAAAAAAAAAAADwAAACADAAAAAAAAAAAAAAEAAACgMgAAVgcAAKr4//8BAAAAf39/AAEAAABkAAAAAAAAABQAAABAHwAAAAAAACYAAAAAAAAAwOD//wAAAAAmAAAAZAAAABYAAABMAAAAAAAAAAAAAAAEAAAAAAAAAAEAAABZWVkKAAAAACgAAAAoAAAAZAAAAGQAAAAAAAAAzMzMAAAAAABQAAAAUAAAAGQAAABkAAAAAAAAABcAAAAUAAAAAAAAAAAAAAD/fwAA/38AAAAAAAAJAAAABAAAAF0AXgAeAAAAaAAAAAAAAAAAAAAAAAAAAAAAAAAAAAAAECcAABAnAAAAAAAAAAAAAAAAAAAAAAAAAAAAAAAAAAAAAAAAAAAAABQAAAAAAAAAwMD/AAAAAABkAAAAMgAAAAAAAABkAAAAAAAAAH9/fwAKAAAAIgAAABgAAAAAAAAAAAAAAAAAAAAAAAAAAAAAAAAAAAAkAAAAJAAAAAAAAAAHAAAAAAAAAAAAAAAAAAAAAAAAAAAAAAAAAAAAf39/ACUAAABYAAAAAAAAAAAAAAAAAAAAAAAAAAAAAAAAAAAAAAAAAAAAAAAAAAAAAAAAAAAAAAA/AAAAAAAAAKCGAQAAAAAAAAAAAAAAAAAMAAAAAQAAAAAAAAAAAAAAAAAAAB8AAABUAAAAAAAABQAAAAEAAAAAAAAAAAAAAAAAAAAAAAAAAAAAAAAAAAAAAAAAAAAAAAJ/f38AAAAAA8zMzADAwP8Af39/AAAAAAAAAAAAAAAAAAAAAAAAAAAAIQAAABgAAAAUAAAAFAMAALYCAAB/NwAAvwoAABAAAAAmAAAACAAAADywAAAAAAAA"/>
+                <pr:smNativeData xmlns:pr="smNativeData" xmlns="smNativeData" val="SMDATA_15_bQt8ZhMAAAAlAAAAZAAAAA0AAAAAkAAAAJAAAACQAAAAkAAAAAAAAAAAAAAAAAAAAAEAAABQAAAAAAAAAAAA4D8AAAAAAADgPwAAAAAAAOA/AAAAAAAA4D8AAAAAAADgPwAAAAAAAOA/AAAAAAAA4D8AAAAAAADgPwAAAAAAAOA/AAAAAAAA4D8CAAAAjAAAAAAAAAAAAAAAQoX0DP///wgAAAAAAAAAAAAAAAAAAAAAAAAAAAAAAAAAAAAAZAAAAAEAAABAAAAAAAAAAAAAAAAAAAAAAAAAAAAAAAAAAAAAAAAAAAAAAAAAAAAAAAAAAAAAAAAAAAAAAAAAAAAAAAAAAAAAAAAAAAAAAAAAAAAAAAAAAAAAAAAAAAAAFAAAADwAAAAAAAAAAAAAAAAAAAkUAAAAAQAAABQAAAAUAAAAFAAAAAEAAAAAAAAAZAAAAGQAAAAAAAAAZAAAAGQAAAAVAAAAYAAAAAAAAAAAAAAADwAAACADAAAAAAAAAAAAAAEAAACgMgAAVgcAAKr4//8BAAAAf39/AAEAAABkAAAAAAAAABQAAABAHwAAAAAAACYAAAAAAAAAwOD//wAAAAAmAAAAZAAAABYAAABMAAAAAAAAAAAAAAAEAAAAAAAAAAEAAABZWVkKAAAAACgAAAAoAAAAZAAAAGQAAAAAAAAAzMzMAAAAAABQAAAAUAAAAGQAAABkAAAAAAAAABcAAAAUAAAAAAAAAAAAAAD/fwAA/38AAAAAAAAJAAAABAAAAF0AXgAeAAAAaAAAAAAAAAAAAAAAAAAAAAAAAAAAAAAAECcAABAnAAAAAAAAAAAAAAAAAAAAAAAAAAAAAAAAAAAAAAAAAAAAABQAAAAAAAAAwMD/AAAAAABkAAAAMgAAAAAAAABkAAAAAAAAAH9/fwAKAAAAIgAAABgAAAAAAAAAAAAAAAAAAAAAAAAAAAAAAAAAAAAkAAAAJAAAAAAAAAAHAAAAAAAAAAAAAAAAAAAAAAAAAAAAAAAAAAAAf39/ACUAAABYAAAAAAAAAAAAAAAAAAAAAAAAAAAAAAAAAAAAAAAAAAAAAAAAAAAAAAAAAAAAAAA/AAAAAAAAAKCGAQAAAAAAAAAAAAAAAAAMAAAAAQAAAAAAAAAAAAAAAAAAAB8AAABUAAAAAAAABQAAAAEAAAAAAAAAAAAAAAAAAAAAAAAAAAAAAAAAAAAAAAAAAAAAAAJ/f38AAAAAA8zMzADAwP8Af39/AAAAAAAAAAAAAAAAAAAAAAAAAAAAIQAAABgAAAAUAAAAFAMAALYCAAB/NwAAvwoAABAAAAAmAAAACAAAADywAAAAAAAA"/>
               </a:ext>
             </a:extLst>
           </p:cNvSpPr>
@@ -6590,7 +6590,7 @@
             <a:spLocks noGrp="1" noChangeArrowheads="1"/>
             <a:extLst>
               <a:ext uri="smNativeData">
-                <pr:smNativeData xmlns:pr="smNativeData" xmlns="smNativeData" val="SMDATA_15_9kV5ZhMAAAAlAAAAZAAAAA0AAAAAkAAAAJAAAACQAAAAkAAAAAAAAAAAAAAAAAAAAAEAAABQAAAAAAAAAAAA4D8AAAAAAADgPwAAAAAAAOA/AAAAAAAA4D8AAAAAAADgPwAAAAAAAOA/AAAAAAAA4D8AAAAAAADgPwAAAAAAAOA/AAAAAAAA4D8CAAAAjAAAAAAAAAAAAAAAQoX0DP///wgAAAAAAAAAAAAAAAAAAAAAAAAAAAAAAAAAAAAAZAAAAAEAAABAAAAAAAAAAAAAAAAAAAAAAAAAAAAAAAAAAAAAAAAAAAAAAAAAAAAAAAAAAAAAAAAAAAAAAAAAAAAAAAAAAAAAAAAAAAAAAAAAAAAAAAAAAAAAAAAAAAAAFAAAADwAAAAAAAAAAAAAAAAAAAkUAAAAAQAAABQAAAAUAAAAFAAAAAEAAAAAAAAAZAAAAGQAAAAAAAAAZAAAAGQAAAAVAAAAYAAAAAAAAAAAAAAADwAAACADAAAAAAAAAAAAAAEAAACgMgAAVgcAAKr4//8BAAAAf39/AAEAAABkAAAAAAAAABQAAABAHwAAAAAAACYAAAAAAAAAwOD//wAAAAAmAAAAZAAAABYAAABMAAAAAAAAAAAAAAAEAAAAAAAAAAEAAABZWVkKAAAAACgAAAAoAAAAZAAAAGQAAAAAAAAAzMzMAAAAAABQAAAAUAAAAGQAAABkAAAAAAAAABcAAAAUAAAAAAAAAAAAAAD/fwAA/38AAAAAAAAJAAAABAAAAAAAAAAeAAAAaAAAAAAAAAAAAAAAAAAAAAAAAAAAAAAAECcAABAnAAAAAAAAAAAAAAAAAAAAAAAAAAAAAAAAAAAAAAAAAAAAABQAAAAAAAAAwMD/AAAAAABkAAAAMgAAAAAAAABkAAAAAAAAAH9/fwAKAAAAIgAAABgAAAAAAAAAAAAAAAAAAAAAAAAAAAAAAAAAAAAkAAAAJAAAAAAAAAAHAAAAAAAAAAAAAAAAAAAAAAAAAAAAAAAAAAAAf39/ACUAAABYAAAAAAAAAAAAAAAAAAAAAAAAAAAAAAAAAAAAAAAAAAAAAAAAAAAAAAAAAAAAAAA/AAAAAAAAAKCGAQAAAAAAAAAAAAAAAAAMAAAAAQAAAAAAAAAAAAAAAAAAAB8AAABUAAAAAAAABQAAAAEAAAAAAAAAAAAAAAAAAAAAAAAAAAAAAAAAAAAAAAAAAAAAAAJ/f38AAAAAA8zMzADAwP8Af39/AAAAAAAAAAAAAAAAAAAAAAAAAAAAIQAAABgAAAAUAAAAwRoAAJQQAADFNQAAZRUAABAAAAAmAAAACAAAAD2wAAAAAAAA"/>
+                <pr:smNativeData xmlns:pr="smNativeData" xmlns="smNativeData" val="SMDATA_15_bQt8ZhMAAAAlAAAAZAAAAA0AAAAAkAAAAJAAAACQAAAAkAAAAAAAAAAAAAAAAAAAAAEAAABQAAAAAAAAAAAA4D8AAAAAAADgPwAAAAAAAOA/AAAAAAAA4D8AAAAAAADgPwAAAAAAAOA/AAAAAAAA4D8AAAAAAADgPwAAAAAAAOA/AAAAAAAA4D8CAAAAjAAAAAAAAAAAAAAAQoX0DP///wgAAAAAAAAAAAAAAAAAAAAAAAAAAAAAAAAAAAAAZAAAAAEAAABAAAAAAAAAAAAAAAAAAAAAAAAAAAAAAAAAAAAAAAAAAAAAAAAAAAAAAAAAAAAAAAAAAAAAAAAAAAAAAAAAAAAAAAAAAAAAAAAAAAAAAAAAAAAAAAAAAAAAFAAAADwAAAAAAAAAAAAAAAAAAAkUAAAAAQAAABQAAAAUAAAAFAAAAAEAAAAAAAAAZAAAAGQAAAAAAAAAZAAAAGQAAAAVAAAAYAAAAAAAAAAAAAAADwAAACADAAAAAAAAAAAAAAEAAACgMgAAVgcAAKr4//8BAAAAf39/AAEAAABkAAAAAAAAABQAAABAHwAAAAAAACYAAAAAAAAAwOD//wAAAAAmAAAAZAAAABYAAABMAAAAAAAAAAAAAAAEAAAAAAAAAAEAAABZWVkKAAAAACgAAAAoAAAAZAAAAGQAAAAAAAAAzMzMAAAAAABQAAAAUAAAAGQAAABkAAAAAAAAABcAAAAUAAAAAAAAAAAAAAD/fwAA/38AAAAAAAAJAAAABAAAAAAAAAAeAAAAaAAAAAAAAAAAAAAAAAAAAAAAAAAAAAAAECcAABAnAAAAAAAAAAAAAAAAAAAAAAAAAAAAAAAAAAAAAAAAAAAAABQAAAAAAAAAwMD/AAAAAABkAAAAMgAAAAAAAABkAAAAAAAAAH9/fwAKAAAAIgAAABgAAAAAAAAAAAAAAAAAAAAAAAAAAAAAAAAAAAAkAAAAJAAAAAAAAAAHAAAAAAAAAAAAAAAAAAAAAAAAAAAAAAAAAAAAf39/ACUAAABYAAAAAAAAAAAAAAAAAAAAAAAAAAAAAAAAAAAAAAAAAAAAAAAAAAAAAAAAAAAAAAA/AAAAAAAAAKCGAQAAAAAAAAAAAAAAAAAMAAAAAQAAAAAAAAAAAAAAAAAAAB8AAABUAAAAAAAABQAAAAEAAAAAAAAAAAAAAAAAAAAAAAAAAAAAAAAAAAAAAAAAAAAAAAJ/f38AAAAAA8zMzADAwP8Af39/AAAAAAAAAAAAAAAAAAAAAAAAAAAAIQAAABgAAAAUAAAAwRoAAJQQAADFNQAAZRUAABAAAAAmAAAACAAAAD2wAAAAAAAA"/>
               </a:ext>
             </a:extLst>
           </p:cNvSpPr>
@@ -6777,7 +6777,7 @@
             <a:spLocks noGrp="1" noChangeArrowheads="1"/>
             <a:extLst>
               <a:ext uri="smNativeData">
-                <pr:smNativeData xmlns:pr="smNativeData" xmlns="smNativeData" val="SMDATA_15_9kV5ZhMAAAAlAAAAZAAAAA0AAAAAkAAAAJAAAACQAAAAkAAAAAAAAAAAAAAAAAAAAAEAAABQAAAAAAAAAAAA4D8AAAAAAADgPwAAAAAAAOA/AAAAAAAA4D8AAAAAAADgPwAAAAAAAOA/AAAAAAAA4D8AAAAAAADgPwAAAAAAAOA/AAAAAAAA4D8CAAAAjAAAAAAAAAAAAAAAQoX0DP///wgAAAAAAAAAAAAAAAAAAAAAAAAAAAAAAAAAAAAAZAAAAAEAAABAAAAAAAAAAAAAAAAAAAAAAAAAAAAAAAAAAAAAAAAAAAAAAAAAAAAAAAAAAAAAAAAAAAAAAAAAAAAAAAAAAAAAAAAAAAAAAAAAAAAAAAAAAAAAAAAAAAAAFAAAADwAAAAAAAAAAAAAAAAAAAkUAAAAAQAAABQAAAAUAAAAFAAAAAEAAAAAAAAAZAAAAGQAAAAAAAAAZAAAAGQAAAAVAAAAYAAAAAAAAAAAAAAADwAAACADAAAAAAAAAAAAAAEAAACgMgAAVgcAAKr4//8BAAAAf39/AAEAAABkAAAAAAAAABQAAABAHwAAAAAAACYAAAAAAAAAwOD//wAAAAAmAAAAZAAAABYAAABMAAAAAAAAAAAAAAAEAAAAAAAAAAEAAABZWVkKAAAAACgAAAAoAAAAZAAAAGQAAAAAAAAAzMzMAAAAAABQAAAAUAAAAGQAAABkAAAAAAAAABcAAAAUAAAAAAAAAAAAAAD/fwAA/38AAAAAAAAJAAAABAAAAAAAAAAeAAAAaAAAAAAAAAAAAAAAAAAAAAAAAAAAAAAAECcAABAnAAAAAAAAAAAAAAAAAAAAAAAAAAAAAAAAAAAAAAAAAAAAABQAAAAAAAAAwMD/AAAAAABkAAAAMgAAAAAAAABkAAAAAAAAAH9/fwAKAAAAIgAAABgAAAAAAAAAAAAAAAAAAAAAAAAAAAAAAAAAAAAkAAAAJAAAAAAAAAAHAAAAAAAAAAAAAAAAAAAAAAAAAAAAAAAAAAAAf39/ACUAAABYAAAAAAAAAAAAAAAAAAAAAAAAAAAAAAAAAAAAAAAAAAAAAAAAAAAAAAAAAAAAAAA/AAAAAAAAAKCGAQAAAAAAAAAAAAAAAAAMAAAAAQAAAAAAAAAAAAAAAAAAAB8AAABUAAAAAAAABQAAAAEAAAAAAAAAAAAAAAAAAAAAAAAAAAAAAAAAAAAAAAAAAAAAAAJ/f38AAAAAA8zMzADAwP8Af39/AAAAAAAAAAAAAAAAAAAAAAAAAAAAIQAAABgAAAAUAAAAwRoAAPoUAAD6NgAAtCUAABAAAAAmAAAACAAAAD2wAAAAAAAA"/>
+                <pr:smNativeData xmlns:pr="smNativeData" xmlns="smNativeData" val="SMDATA_15_bQt8ZhMAAAAlAAAAZAAAAA0AAAAAkAAAAJAAAACQAAAAkAAAAAAAAAAAAAAAAAAAAAEAAABQAAAAAAAAAAAA4D8AAAAAAADgPwAAAAAAAOA/AAAAAAAA4D8AAAAAAADgPwAAAAAAAOA/AAAAAAAA4D8AAAAAAADgPwAAAAAAAOA/AAAAAAAA4D8CAAAAjAAAAAAAAAAAAAAAQoX0DP///wgAAAAAAAAAAAAAAAAAAAAAAAAAAAAAAAAAAAAAZAAAAAEAAABAAAAAAAAAAAAAAAAAAAAAAAAAAAAAAAAAAAAAAAAAAAAAAAAAAAAAAAAAAAAAAAAAAAAAAAAAAAAAAAAAAAAAAAAAAAAAAAAAAAAAAAAAAAAAAAAAAAAAFAAAADwAAAAAAAAAAAAAAAAAAAkUAAAAAQAAABQAAAAUAAAAFAAAAAEAAAAAAAAAZAAAAGQAAAAAAAAAZAAAAGQAAAAVAAAAYAAAAAAAAAAAAAAADwAAACADAAAAAAAAAAAAAAEAAACgMgAAVgcAAKr4//8BAAAAf39/AAEAAABkAAAAAAAAABQAAABAHwAAAAAAACYAAAAAAAAAwOD//wAAAAAmAAAAZAAAABYAAABMAAAAAAAAAAAAAAAEAAAAAAAAAAEAAABZWVkKAAAAACgAAAAoAAAAZAAAAGQAAAAAAAAAzMzMAAAAAABQAAAAUAAAAGQAAABkAAAAAAAAABcAAAAUAAAAAAAAAAAAAAD/fwAA/38AAAAAAAAJAAAABAAAAAAAAAAeAAAAaAAAAAAAAAAAAAAAAAAAAAAAAAAAAAAAECcAABAnAAAAAAAAAAAAAAAAAAAAAAAAAAAAAAAAAAAAAAAAAAAAABQAAAAAAAAAwMD/AAAAAABkAAAAMgAAAAAAAABkAAAAAAAAAH9/fwAKAAAAIgAAABgAAAAAAAAAAAAAAAAAAAAAAAAAAAAAAAAAAAAkAAAAJAAAAAAAAAAHAAAAAAAAAAAAAAAAAAAAAAAAAAAAAAAAAAAAf39/ACUAAABYAAAAAAAAAAAAAAAAAAAAAAAAAAAAAAAAAAAAAAAAAAAAAAAAAAAAAAAAAAAAAAA/AAAAAAAAAKCGAQAAAAAAAAAAAAAAAAAMAAAAAQAAAAAAAAAAAAAAAAAAAB8AAABUAAAAAAAABQAAAAEAAAAAAAAAAAAAAAAAAAAAAAAAAAAAAAAAAAAAAAAAAAAAAAJ/f38AAAAAA8zMzADAwP8Af39/AAAAAAAAAAAAAAAAAAAAAAAAAAAAIQAAABgAAAAUAAAAwRoAAPoUAAD6NgAAtCUAABAAAAAmAAAACAAAAD2wAAAAAAAA"/>
               </a:ext>
             </a:extLst>
           </p:cNvSpPr>
@@ -6988,7 +6988,7 @@
           <p:cNvSpPr>
             <a:extLst>
               <a:ext uri="smNativeData">
-                <pr:smNativeData xmlns:pr="smNativeData" xmlns="smNativeData" val="SMDATA_15_9kV5ZhMAAAAlAAAAZAAAAA0AAAAAkAAAAJAAAACQAAAAkAAAAAAAAAABAAAAAAAAAAEAAABQAAAAAAAAAAAA4D8AAAAAAADgPwAAAAAAAOA/AAAAAAAA4D8AAAAAAADgPwAAAAAAAOA/AAAAAAAA4D8AAAAAAADgPwAAAAAAAOA/AAAAAAAA4D8CAAAAjAAAAAEAAAAAAAAA8/PzAP///wgAAAAAAAAAAAAAAAAAAAAAAAAAAAAAAAAAAAAAeAAAAAEAAABAAAAAAAAAAAAAAABaAAAAAAAAAAAAAAAAAAAAAAAAAAAAAAAAAAAAAAAAAAAAAAAAAAAAAAAAAAAAAAAAAAAAAAAAAAAAAAAAAAAAAAAAAAAAAAAAAAAAFAAAADwAAAAAAAAAAAAAAAAAAAkUAAAAAQAAABQAAAAUAAAAFAAAAAEAAAAAAAAAZAAAAGQAAAAAAAAAZAAAAGQAAAAVAAAAYAAAAAAAAAAAAAAADwAAACADAAAAAAAAAAAAAAEAAACgMgAAVgcAAKr4//8BAAAAf39/AAEAAABkAAAAAAAAABQAAABAHwAAAAAAACYAAAAAAAAAwOD//wAAAAAmAAAAZAAAABYAAABMAAAAAAAAAAAAAAAEAAAAAAAAAAEAAABZWVkKAAAAACgAAAAoAAAAZAAAAGQAAAAAAAAAzMzMAAAAAABQAAAAUAAAAGQAAABkAAAAAAAAABcAAAAUAAAAAAAAAAAAAAD/fwAA/38AAAAAAAAJAAAABAAAAAAAAAAeAAAAaAAAAAAAAAAAAAAAAAAAAAAAAAAAAAAAECcAABAnAAAAAAAAAAAAAAAAAAAAAAAAAAAAAAAAAAAAAAAAAAAAABQAAAAAAAAAwMD/AAAAAABkAAAAMgAAAAAAAABkAAAAAAAAAH9/fwAKAAAAIgAAABgAAAAAAAAAAAAAAAAAAAAAAAAAAAAAAAAAAAAkAAAAJAAAAAAAAAAHAAAAAAAAAAAAAAAAAAAAAAAAAAAAAAAAAAAAf39/ACUAAABYAAAAAAAAAAAAAAAAAAAAAAAAAAAAAAAAAAAAAAAAAAAAAAAAAAAAAAAAAAAAAAA/AAAAAAAAAKCGAQAAAAAAAAAAAAAAAAAMAAAAAQAAAAAAAAAAAAAAAAAAAB8AAABUAAAA8/PzAAAAAAEAAAAAAAAAAAAAAAAAAAAAAAAAAAAAAAAAAAAAAAAAAAAAAAJ/f38AAAAAA8zMzADAwP8Af39/AAAAAAAAAAAAAAAAAAAAAAAAAAAAIQAAABgAAAAUAAAAIBwAAAAAAABAOAAAMCoAABAAAAAmAAAACAAAAP//////////"/>
+                <pr:smNativeData xmlns:pr="smNativeData" xmlns="smNativeData" val="SMDATA_15_bQt8ZhMAAAAlAAAAZAAAAA0AAAAAkAAAAJAAAACQAAAAkAAAAAAAAAABAAAAAAAAAAEAAABQAAAAAAAAAAAA4D8AAAAAAADgPwAAAAAAAOA/AAAAAAAA4D8AAAAAAADgPwAAAAAAAOA/AAAAAAAA4D8AAAAAAADgPwAAAAAAAOA/AAAAAAAA4D8CAAAAjAAAAAEAAAAAAAAA8/PzAP///wgAAAAAAAAAAAAAAAAAAAAAAAAAAAAAAAAAAAAAeAAAAAEAAABAAAAAAAAAAAAAAABaAAAAAAAAAAAAAAAAAAAAAAAAAAAAAAAAAAAAAAAAAAAAAAAAAAAAAAAAAAAAAAAAAAAAAAAAAAAAAAAAAAAAAAAAAAAAAAAAAAAAFAAAADwAAAAAAAAAAAAAAAAAAAkUAAAAAQAAABQAAAAUAAAAFAAAAAEAAAAAAAAAZAAAAGQAAAAAAAAAZAAAAGQAAAAVAAAAYAAAAAAAAAAAAAAADwAAACADAAAAAAAAAAAAAAEAAACgMgAAVgcAAKr4//8BAAAAf39/AAEAAABkAAAAAAAAABQAAABAHwAAAAAAACYAAAAAAAAAwOD//wAAAAAmAAAAZAAAABYAAABMAAAAAAAAAAAAAAAEAAAAAAAAAAEAAABZWVkKAAAAACgAAAAoAAAAZAAAAGQAAAAAAAAAzMzMAAAAAABQAAAAUAAAAGQAAABkAAAAAAAAABcAAAAUAAAAAAAAAAAAAAD/fwAA/38AAAAAAAAJAAAABAAAAAAAAAAeAAAAaAAAAAAAAAAAAAAAAAAAAAAAAAAAAAAAECcAABAnAAAAAAAAAAAAAAAAAAAAAAAAAAAAAAAAAAAAAAAAAAAAABQAAAAAAAAAwMD/AAAAAABkAAAAMgAAAAAAAABkAAAAAAAAAH9/fwAKAAAAIgAAABgAAAAAAAAAAAAAAAAAAAAAAAAAAAAAAAAAAAAkAAAAJAAAAAAAAAAHAAAAAAAAAAAAAAAAAAAAAAAAAAAAAAAAAAAAf39/ACUAAABYAAAAAAAAAAAAAAAAAAAAAAAAAAAAAAAAAAAAAAAAAAAAAAAAAAAAAAAAAAAAAAA/AAAAAAAAAKCGAQAAAAAAAAAAAAAAAAAMAAAAAQAAAAAAAAAAAAAAAAAAAB8AAABUAAAA8/PzAAAAAAEAAAAAAAAAAAAAAAAAAAAAAAAAAAAAAAAAAAAAAAAAAAAAAAJ/f38AAAAAA8zMzADAwP8Af39/AAAAAAAAAAAAAAAAAAAAAAAAAAAAIQAAABgAAAAUAAAAIBwAAAAAAABAOAAAMCoAABAAAAAmAAAACAAAAP//////////"/>
               </a:ext>
             </a:extLst>
           </p:cNvSpPr>
@@ -7033,7 +7033,7 @@
             <a:spLocks noGrp="1" noChangeArrowheads="1"/>
             <a:extLst>
               <a:ext uri="smNativeData">
-                <pr:smNativeData xmlns:pr="smNativeData" xmlns="smNativeData" val="SMDATA_15_9kV5ZhMAAAAlAAAAZAAAAA0AAAAAkAAAAJAAAACQAAAAkAAAAAAAAAACAAAAAAAAAAEAAABQAAAAAAAAAAAA4D8AAAAAAADgPwAAAAAAAOA/AAAAAAAA4D8AAAAAAADgPwAAAAAAAOA/AAAAAAAA4D8AAAAAAADgPwAAAAAAAOA/AAAAAAAA4D8CAAAAjAAAAAAAAAAAAAAAQoX0DP///wgAAAAAAAAAAAAAAAAAAAAAAAAAAAAAAAAAAAAAZAAAAAEAAABAAAAAAAAAAAAAAAAAAAAAAAAAAAAAAAAAAAAAAAAAAAAAAAAAAAAAAAAAAAAAAAAAAAAAAAAAAAAAAAAAAAAAAAAAAAAAAAAAAAAAAAAAAAAAAAAAAAAAFAAAADwAAAAAAAAAAAAAAAAAAAkUAAAAAQAAABQAAAAUAAAAFAAAAAEAAAAAAAAAZAAAAGQAAAAAAAAAZAAAAGQAAAAVAAAAYAAAAAAAAAAAAAAADwAAACADAAAAAAAAAAAAAAEAAACgMgAAVgcAAKr4//8BAAAAf39/AAEAAABkAAAAAAAAABQAAABAHwAAAAAAACYAAAAAAAAAwOD//wAAAAAmAAAAZAAAABYAAABMAAAAAAAAAAAAAAAEAAAAAAAAAAEAAABZWVkKAAAAACgAAAAoAAAAZAAAAGQAAAAAAAAAzMzMAAAAAABQAAAAUAAAAGQAAABkAAAAAAAAABcAAAAUAAAAAAAAAAAAAAD/fwAA/38AAAAAAAAJAAAABAAAAAAAAAAeAAAAaAAAAAAAAAAAAAAAAAAAAAAAAAAAAAAAECcAABAnAAAAAAAAAAAAAAAAAAAAAAAAAAAAAAAAAAAAAAAAAAAAABQAAAAAAAAAwMD/AAAAAABkAAAAMgAAAAAAAABkAAAAAAAAAH9/fwAKAAAAIgAAABgAAAAAAAAAAAAAAAAAAAAAAAAAAAAAAAAAAAAkAAAAJAAAAAAAAAAHAAAAAAAAAAAAAAAAAAAAAAAAAAAAAAAAAAAAf39/ACUAAABYAAAAAAAAAAAAAAAAAAAAAAAAAAAAAAAAAAAAAAAAAAAAAAAAAAAAAAAAAAAAAAA/AAAAAAAAAKCGAQAAAAAAAAAAAAAAAAAMAAAAAQAAAAAAAAAAAAAAAAAAAB8AAABUAAAAAAAABQAAAAEAAAAAAAAAAAAAAAAAAAAAAAAAAAAAAAAAAAAAAAAAAAAAAAJ/f38AAAAAA8zMzADAwP8Af39/AAAAAAAAAAAAAAAAAAAAAAAAAAAAIQAAABgAAAAUAAAAvwMAAAQKAACiHAAALBYAABAAAAAmAAAACAAAAL2wAAAAAAAA"/>
+                <pr:smNativeData xmlns:pr="smNativeData" xmlns="smNativeData" val="SMDATA_15_bQt8ZhMAAAAlAAAAZAAAAA0AAAAAkAAAAJAAAACQAAAAkAAAAAAAAAACAAAAAAAAAAEAAABQAAAAAAAAAAAA4D8AAAAAAADgPwAAAAAAAOA/AAAAAAAA4D8AAAAAAADgPwAAAAAAAOA/AAAAAAAA4D8AAAAAAADgPwAAAAAAAOA/AAAAAAAA4D8CAAAAjAAAAAAAAAAAAAAAQoX0DP///wgAAAAAAAAAAAAAAAAAAAAAAAAAAAAAAAAAAAAAZAAAAAEAAABAAAAAAAAAAAAAAAAAAAAAAAAAAAAAAAAAAAAAAAAAAAAAAAAAAAAAAAAAAAAAAAAAAAAAAAAAAAAAAAAAAAAAAAAAAAAAAAAAAAAAAAAAAAAAAAAAAAAAFAAAADwAAAAAAAAAAAAAAAAAAAkUAAAAAQAAABQAAAAUAAAAFAAAAAEAAAAAAAAAZAAAAGQAAAAAAAAAZAAAAGQAAAAVAAAAYAAAAAAAAAAAAAAADwAAACADAAAAAAAAAAAAAAEAAACgMgAAVgcAAKr4//8BAAAAf39/AAEAAABkAAAAAAAAABQAAABAHwAAAAAAACYAAAAAAAAAwOD//wAAAAAmAAAAZAAAABYAAABMAAAAAAAAAAAAAAAEAAAAAAAAAAEAAABZWVkKAAAAACgAAAAoAAAAZAAAAGQAAAAAAAAAzMzMAAAAAABQAAAAUAAAAGQAAABkAAAAAAAAABcAAAAUAAAAAAAAAAAAAAD/fwAA/38AAAAAAAAJAAAABAAAAAAAAAAeAAAAaAAAAAAAAAAAAAAAAAAAAAAAAAAAAAAAECcAABAnAAAAAAAAAAAAAAAAAAAAAAAAAAAAAAAAAAAAAAAAAAAAABQAAAAAAAAAwMD/AAAAAABkAAAAMgAAAAAAAABkAAAAAAAAAH9/fwAKAAAAIgAAABgAAAAAAAAAAAAAAAAAAAAAAAAAAAAAAAAAAAAkAAAAJAAAAAAAAAAHAAAAAAAAAAAAAAAAAAAAAAAAAAAAAAAAAAAAf39/ACUAAABYAAAAAAAAAAAAAAAAAAAAAAAAAAAAAAAAAAAAAAAAAAAAAAAAAAAAAAAAAAAAAAA/AAAAAAAAAKCGAQAAAAAAAAAAAAAAAAAMAAAAAQAAAAAAAAAAAAAAAAAAAB8AAABUAAAAAAAABQAAAAEAAAAAAAAAAAAAAAAAAAAAAAAAAAAAAAAAAAAAAAAAAAAAAAJ/f38AAAAAA8zMzADAwP8Af39/AAAAAAAAAAAAAAAAAAAAAAAAAAAAIQAAABgAAAAUAAAAvwMAAAQKAACiHAAALBYAABAAAAAmAAAACAAAAL2wAAAAAAAA"/>
               </a:ext>
             </a:extLst>
           </p:cNvSpPr>
@@ -7157,7 +7157,7 @@
             <a:spLocks noGrp="1" noChangeArrowheads="1"/>
             <a:extLst>
               <a:ext uri="smNativeData">
-                <pr:smNativeData xmlns:pr="smNativeData" xmlns="smNativeData" val="SMDATA_15_9kV5ZhMAAAAlAAAAZAAAAA0AAAAAkAAAAJAAAACQAAAAkAAAAAAAAAAAAAAAAAAAAAEAAABQAAAAAAAAAAAA4D8AAAAAAADgPwAAAAAAAOA/AAAAAAAA4D8AAAAAAADgPwAAAAAAAOA/AAAAAAAA4D8AAAAAAADgPwAAAAAAAOA/AAAAAAAA4D8CAAAAjAAAAAAAAAAAAAAAQoX0DP///wgAAAAAAAAAAAAAAAAAAAAAAAAAAAAAAAAAAAAAZAAAAAEAAABAAAAAAAAAAAAAAAAAAAAAAAAAAAAAAAAAAAAAAAAAAAAAAAAAAAAAAAAAAAAAAAAAAAAAAAAAAAAAAAAAAAAAAAAAAAAAAAAAAAAAAAAAAAAAAAAAAAAAFAAAADwAAAAAAAAAAAAAAAAAAAkUAAAAAQAAABQAAAAUAAAAFAAAAAEAAAAAAAAAZAAAAGQAAAAAAAAAZAAAAGQAAAAVAAAAYAAAAAAAAAAAAAAADwAAACADAAAAAAAAAAAAAAEAAACgMgAAVgcAAKr4//8BAAAAf39/AAEAAABkAAAAAAAAABQAAABAHwAAAAAAACYAAAAAAAAAwOD//wAAAAAmAAAAZAAAABYAAABMAAAAAAAAAAAAAAAEAAAAAAAAAAEAAABZWVkKAAAAACgAAAAoAAAAZAAAAGQAAAAAAAAAzMzMAAAAAABQAAAAUAAAAGQAAABkAAAAAAAAABcAAAAUAAAAAAAAAAAAAAD/fwAA/38AAAAAAAAJAAAABAAAAAAAAAAeAAAAaAAAAAAAAAAAAAAAAAAAAAAAAAAAAAAAECcAABAnAAAAAAAAAAAAAAAAAAAAAAAAAAAAAAAAAAAAAAAAAAAAABQAAAAAAAAAwMD/AAAAAABkAAAAMgAAAAAAAABkAAAAAAAAAH9/fwAKAAAAIgAAABgAAAAAAAAAAAAAAAAAAAAAAAAAAAAAAAAAAAAkAAAAJAAAAAAAAAAHAAAAAAAAAAAAAAAAAAAAAAAAAAAAAAAAAAAAf39/ACUAAABYAAAAAAAAAAAAAAAAAAAAAAAAAAAAAAAAAAAAAAAAAAAAAAAAAAAAAAAAAAAAAAA/AAAAAAAAAKCGAQAAAAAAAAAAAAAAAAAMAAAAAQAAAAAAAAAAAAAAAAAAAB8AAABUAAAAAAAABQAAAAEAAAAAAAAAAAAAAAAAAAAAAAAAAAAAAAAAAAAAAAAAAAAAAAJ/f38AAAAAA8zMzADAwP8Af39/AAAAAAAAAAAAAAAAAAAAAAAAAAAAIQAAABgAAAAUAAAAvwMAAOsXAACiHAAADSIAABAAAAAmAAAACAAAAD2wAAAAAAAA"/>
+                <pr:smNativeData xmlns:pr="smNativeData" xmlns="smNativeData" val="SMDATA_15_bQt8ZhMAAAAlAAAAZAAAAA0AAAAAkAAAAJAAAACQAAAAkAAAAAAAAAAAAAAAAAAAAAEAAABQAAAAAAAAAAAA4D8AAAAAAADgPwAAAAAAAOA/AAAAAAAA4D8AAAAAAADgPwAAAAAAAOA/AAAAAAAA4D8AAAAAAADgPwAAAAAAAOA/AAAAAAAA4D8CAAAAjAAAAAAAAAAAAAAAQoX0DP///wgAAAAAAAAAAAAAAAAAAAAAAAAAAAAAAAAAAAAAZAAAAAEAAABAAAAAAAAAAAAAAAAAAAAAAAAAAAAAAAAAAAAAAAAAAAAAAAAAAAAAAAAAAAAAAAAAAAAAAAAAAAAAAAAAAAAAAAAAAAAAAAAAAAAAAAAAAAAAAAAAAAAAFAAAADwAAAAAAAAAAAAAAAAAAAkUAAAAAQAAABQAAAAUAAAAFAAAAAEAAAAAAAAAZAAAAGQAAAAAAAAAZAAAAGQAAAAVAAAAYAAAAAAAAAAAAAAADwAAACADAAAAAAAAAAAAAAEAAACgMgAAVgcAAKr4//8BAAAAf39/AAEAAABkAAAAAAAAABQAAABAHwAAAAAAACYAAAAAAAAAwOD//wAAAAAmAAAAZAAAABYAAABMAAAAAAAAAAAAAAAEAAAAAAAAAAEAAABZWVkKAAAAACgAAAAoAAAAZAAAAGQAAAAAAAAAzMzMAAAAAABQAAAAUAAAAGQAAABkAAAAAAAAABcAAAAUAAAAAAAAAAAAAAD/fwAA/38AAAAAAAAJAAAABAAAAAAAAAAeAAAAaAAAAAAAAAAAAAAAAAAAAAAAAAAAAAAAECcAABAnAAAAAAAAAAAAAAAAAAAAAAAAAAAAAAAAAAAAAAAAAAAAABQAAAAAAAAAwMD/AAAAAABkAAAAMgAAAAAAAABkAAAAAAAAAH9/fwAKAAAAIgAAABgAAAAAAAAAAAAAAAAAAAAAAAAAAAAAAAAAAAAkAAAAJAAAAAAAAAAHAAAAAAAAAAAAAAAAAAAAAAAAAAAAAAAAAAAAf39/ACUAAABYAAAAAAAAAAAAAAAAAAAAAAAAAAAAAAAAAAAAAAAAAAAAAAAAAAAAAAAAAAAAAAA/AAAAAAAAAKCGAQAAAAAAAAAAAAAAAAAMAAAAAQAAAAAAAAAAAAAAAAAAAB8AAABUAAAAAAAABQAAAAEAAAAAAAAAAAAAAAAAAAAAAAAAAAAAAAAAAAAAAAAAAAAAAAJ/f38AAAAAA8zMzADAwP8Af39/AAAAAAAAAAAAAAAAAAAAAAAAAAAAIQAAABgAAAAUAAAAvwMAAOsXAACiHAAADSIAABAAAAAmAAAACAAAAD2wAAAAAAAA"/>
               </a:ext>
             </a:extLst>
           </p:cNvSpPr>
@@ -7308,7 +7308,7 @@
             <a:spLocks noGrp="1" noChangeArrowheads="1"/>
             <a:extLst>
               <a:ext uri="smNativeData">
-                <pr:smNativeData xmlns:pr="smNativeData" xmlns="smNativeData" val="SMDATA_15_9kV5ZhMAAAAlAAAAZAAAAA0AAAAAkAAAAJAAAACQAAAAkAAAAAAAAAABAAAAAAAAAAEAAABQAAAAAAAAAAAA4D8AAAAAAADgPwAAAAAAAOA/AAAAAAAA4D8AAAAAAADgPwAAAAAAAOA/AAAAAAAA4D8AAAAAAADgPwAAAAAAAOA/AAAAAAAA4D8CAAAAjAAAAAAAAAAAAAAAQoX0DP///wgAAAAAAAAAAAAAAAAAAAAAAAAAAAAAAAAAAAAAZAAAAAEAAABAAAAAAAAAAAAAAAAAAAAAAAAAAAAAAAAAAAAAAAAAAAAAAAAAAAAAAAAAAAAAAAAAAAAAAAAAAAAAAAAAAAAAAAAAAAAAAAAAAAAAAAAAAAAAAAAAAAAAFAAAADwAAAAAAAAAAAAAAAAAAAkUAAAAAQAAABQAAAAUAAAAFAAAAAEAAAAAAAAAZAAAAGQAAAAAAAAAZAAAAGQAAAAVAAAAYAAAAAAAAAAAAAAADwAAACADAAAAAAAAAAAAAAEAAACgMgAAVgcAAKr4//8BAAAAf39/AAEAAABkAAAAAAAAABQAAABAHwAAAAAAACYAAAAAAAAAwOD//wAAAAAmAAAAZAAAABYAAABMAAAAAAAAAAAAAAAEAAAAAAAAAAEAAABZWVkKAAAAACgAAAAoAAAAZAAAAGQAAAAAAAAAzMzMAAAAAABQAAAAUAAAAGQAAABkAAAAAAAAABcAAAAUAAAAAAAAAAAAAAD/fwAA/38AAAAAAAAJAAAABAAAAAAAAMAeAAAAaAAAAAAAAAAAAAAAAAAAAAAAAAAAAAAAECcAABAnAAAAAAAAAAAAAAAAAAAAAAAAAAAAAAAAAAAAAAAAAAAAABQAAAAAAAAAwMD/AAAAAABkAAAAMgAAAAAAAABkAAAAAAAAAH9/fwAKAAAAIgAAABgAAAAAAAAAAAAAAAAAAAAAAAAAAAAAAAAAAAAkAAAAJAAAAAAAAAAHAAAAAAAAAAAAAAAAAAAAAAAAAAAAAAAAAAAAf39/ACUAAABYAAAAAAAAAAAAAAAAAAAAAAAAAAAAAAAAAAAAAAAAAAAAAAAAAAAAAAAAAAAAAAA/AAAAAAAAAKCGAQAAAAAAAAAAAAAAAAAMAAAAAQAAAAAAAAAAAAAAAAAAAB8AAABUAAAAAAAABQAAAAEAAAAAAAAAAAAAAAAAAAAAAAAAAAAAAAAAAAAAAAAAAAAAAAJ/f38AAAAAA8zMzADAwP8Af39/AAAAAAAAAAAAAAAAAAAAAAAAAAAAIQAAABgAAAAUAAAAYx4AAPAFAAD9NQAAPyQAABAAAAAmAAAACAAAAL2wAAAAAAAA"/>
+                <pr:smNativeData xmlns:pr="smNativeData" xmlns="smNativeData" val="SMDATA_15_bQt8ZhMAAAAlAAAAZAAAAA0AAAAAkAAAAJAAAACQAAAAkAAAAAAAAAABAAAAAAAAAAEAAABQAAAAAAAAAAAA4D8AAAAAAADgPwAAAAAAAOA/AAAAAAAA4D8AAAAAAADgPwAAAAAAAOA/AAAAAAAA4D8AAAAAAADgPwAAAAAAAOA/AAAAAAAA4D8CAAAAjAAAAAAAAAAAAAAAQoX0DP///wgAAAAAAAAAAAAAAAAAAAAAAAAAAAAAAAAAAAAAZAAAAAEAAABAAAAAAAAAAAAAAAAAAAAAAAAAAAAAAAAAAAAAAAAAAAAAAAAAAAAAAAAAAAAAAAAAAAAAAAAAAAAAAAAAAAAAAAAAAAAAAAAAAAAAAAAAAAAAAAAAAAAAFAAAADwAAAAAAAAAAAAAAAAAAAkUAAAAAQAAABQAAAAUAAAAFAAAAAEAAAAAAAAAZAAAAGQAAAAAAAAAZAAAAGQAAAAVAAAAYAAAAAAAAAAAAAAADwAAACADAAAAAAAAAAAAAAEAAACgMgAAVgcAAKr4//8BAAAAf39/AAEAAABkAAAAAAAAABQAAABAHwAAAAAAACYAAAAAAAAAwOD//wAAAAAmAAAAZAAAABYAAABMAAAAAAAAAAAAAAAEAAAAAAAAAAEAAABZWVkKAAAAACgAAAAoAAAAZAAAAGQAAAAAAAAAzMzMAAAAAABQAAAAUAAAAGQAAABkAAAAAAAAABcAAAAUAAAAAAAAAAAAAAD/fwAA/38AAAAAAAAJAAAABAAAAAAAAMAeAAAAaAAAAAAAAAAAAAAAAAAAAAAAAAAAAAAAECcAABAnAAAAAAAAAAAAAAAAAAAAAAAAAAAAAAAAAAAAAAAAAAAAABQAAAAAAAAAwMD/AAAAAABkAAAAMgAAAAAAAABkAAAAAAAAAH9/fwAKAAAAIgAAABgAAAAAAAAAAAAAAAAAAAAAAAAAAAAAAAAAAAAkAAAAJAAAAAAAAAAHAAAAAAAAAAAAAAAAAAAAAAAAAAAAAAAAAAAAf39/ACUAAABYAAAAAAAAAAAAAAAAAAAAAAAAAAAAAAAAAAAAAAAAAAAAAAAAAAAAAAAAAAAAAAA/AAAAAAAAAKCGAQAAAAAAAAAAAAAAAAAMAAAAAQAAAAAAAAAAAAAAAAAAAB8AAABUAAAAAAAABQAAAAEAAAAAAAAAAAAAAAAAAAAAAAAAAAAAAAAAAAAAAAAAAAAAAAJ/f38AAAAAA8zMzADAwP8Af39/AAAAAAAAAAAAAAAAAAAAAAAAAAAAIQAAABgAAAAUAAAAYx4AAPAFAAD9NQAAPyQAABAAAAAmAAAACAAAAL2wAAAAAAAA"/>
               </a:ext>
             </a:extLst>
           </p:cNvSpPr>
@@ -7432,7 +7432,7 @@
             <a:spLocks noGrp="1" noChangeArrowheads="1"/>
             <a:extLst>
               <a:ext uri="smNativeData">
-                <pr:smNativeData xmlns:pr="smNativeData" xmlns="smNativeData" val="SMDATA_15_9kV5ZhMAAAAlAAAAZAAAAA0AAAAAkAAAAJAAAACQAAAAkAAAAAAAAAABAAAAAAAAAAEAAABQAAAAAAAAAAAA4D8AAAAAAADgPwAAAAAAAOA/AAAAAAAA4D8AAAAAAADgPwAAAAAAAOA/AAAAAAAA4D8AAAAAAADgPwAAAAAAAOA/AAAAAAAA4D8CAAAAjAAAAAAAAAAAAAAAQoX0DP///wgAAAAAAAAAAAAAAAAAAAAAAAAAAAAAAAAAAAAAZAAAAAEAAABAAAAAAAAAAAAAAAAAAAAAAAAAAAAAAAAAAAAAAAAAAAAAAAAAAAAAAAAAAAAAAAAAAAAAAAAAAAAAAAAAAAAAAAAAAAAAAAAAAAAAAAAAAAAAAAAAAAAAFAAAADwAAAAAAAAAAAAAAAAAAAkUAAAAAQAAABQAAAAUAAAAFAAAAAEAAAAAAAAAZAAAAGQAAAAAAAAAZAAAAGQAAAAVAAAAYAAAAAAAAAAAAAAADwAAACADAAAAAAAAAAAAAAEAAACgMgAAVgcAAKr4//8BAAAAf39/AAEAAABkAAAAAAAAABQAAABAHwAAAAAAACYAAAAAAAAAwOD//wAAAAAmAAAAZAAAABYAAABMAAAAAAAAAAAAAAAEAAAAAAAAAAEAAABZWVkKAAAAACgAAAAoAAAAZAAAAGQAAAAAAAAAzMzMAAAAAABQAAAAUAAAAGQAAABkAAAAAAAAABcAAAAUAAAAAAAAAAAAAAD/fwAA/38AAAAAAAAJAAAABAAAAAAAAAAeAAAAaAAAAAAAAAAAAAAAAAAAAAAAAAAAAAAAECcAABAnAAAAAAAAAAAAAAAAAAAAAAAAAAAAAAAAAAAAAAAAAAAAABQAAAAAAAAAwMD/AAAAAABkAAAAMgAAAAAAAABkAAAAAAAAAH9/fwAKAAAAIgAAABgAAAAAAAAAAAAAAAAAAAAAAAAAAAAAAAAAAAAkAAAAJAAAAAAAAAAHAAAAAAAAAAAAAAAAAAAAAAAAAAAAAAAAAAAAf39/ACUAAABYAAAAAAAAAAAAAAAAAAAAAAAAAAAAAAAAAAAAAAAAAAAAAAAAAAAAAAAAAAAAAAA/AAAAAAAAAKCGAQAAAAAAAAAAAAAAAAAMAAAAAQAAAAAAAAAAAAAAAAAAAB8AAABUAAAAAAAABQAAAAEAAAAAAAAAAAAAAAAAAAAAAAAAAAAAAAAAAAAAAAAAAAAAAAJ/f38AAAAAA8zMzADAwP8Af39/AAAAAAAAAAAAAAAAAAAAAAAAAAAAIQAAABgAAAAUAAAAHjQAAEAmAAB/NwAAeikAABAAAAAmAAAACAAAADywAAAAAAAA"/>
+                <pr:smNativeData xmlns:pr="smNativeData" xmlns="smNativeData" val="SMDATA_15_bQt8ZhMAAAAlAAAAZAAAAA0AAAAAkAAAAJAAAACQAAAAkAAAAAAAAAABAAAAAAAAAAEAAABQAAAAAAAAAAAA4D8AAAAAAADgPwAAAAAAAOA/AAAAAAAA4D8AAAAAAADgPwAAAAAAAOA/AAAAAAAA4D8AAAAAAADgPwAAAAAAAOA/AAAAAAAA4D8CAAAAjAAAAAAAAAAAAAAAQoX0DP///wgAAAAAAAAAAAAAAAAAAAAAAAAAAAAAAAAAAAAAZAAAAAEAAABAAAAAAAAAAAAAAAAAAAAAAAAAAAAAAAAAAAAAAAAAAAAAAAAAAAAAAAAAAAAAAAAAAAAAAAAAAAAAAAAAAAAAAAAAAAAAAAAAAAAAAAAAAAAAAAAAAAAAFAAAADwAAAAAAAAAAAAAAAAAAAkUAAAAAQAAABQAAAAUAAAAFAAAAAEAAAAAAAAAZAAAAGQAAAAAAAAAZAAAAGQAAAAVAAAAYAAAAAAAAAAAAAAADwAAACADAAAAAAAAAAAAAAEAAACgMgAAVgcAAKr4//8BAAAAf39/AAEAAABkAAAAAAAAABQAAABAHwAAAAAAACYAAAAAAAAAwOD//wAAAAAmAAAAZAAAABYAAABMAAAAAAAAAAAAAAAEAAAAAAAAAAEAAABZWVkKAAAAACgAAAAoAAAAZAAAAGQAAAAAAAAAzMzMAAAAAABQAAAAUAAAAGQAAABkAAAAAAAAABcAAAAUAAAAAAAAAAAAAAD/fwAA/38AAAAAAAAJAAAABAAAAAAAAAAeAAAAaAAAAAAAAAAAAAAAAAAAAAAAAAAAAAAAECcAABAnAAAAAAAAAAAAAAAAAAAAAAAAAAAAAAAAAAAAAAAAAAAAABQAAAAAAAAAwMD/AAAAAABkAAAAMgAAAAAAAABkAAAAAAAAAH9/fwAKAAAAIgAAABgAAAAAAAAAAAAAAAAAAAAAAAAAAAAAAAAAAAAkAAAAJAAAAAAAAAAHAAAAAAAAAAAAAAAAAAAAAAAAAAAAAAAAAAAAf39/ACUAAABYAAAAAAAAAAAAAAAAAAAAAAAAAAAAAAAAAAAAAAAAAAAAAAAAAAAAAAAAAAAAAAA/AAAAAAAAAKCGAQAAAAAAAAAAAAAAAAAMAAAAAQAAAAAAAAAAAAAAAAAAAB8AAABUAAAAAAAABQAAAAEAAAAAAAAAAAAAAAAAAAAAAAAAAAAAAAAAAAAAAAAAAAAAAAJ/f38AAAAAA8zMzADAwP8Af39/AAAAAAAAAAAAAAAAAAAAAAAAAAAAIQAAABgAAAAUAAAAHjQAAEAmAAB/NwAAeikAABAAAAAmAAAACAAAADywAAAAAAAA"/>
               </a:ext>
             </a:extLst>
           </p:cNvSpPr>
@@ -7486,7 +7486,7 @@
               </a:spcAft>
               <a:buNone/>
             </a:pPr>
-            <a:fld id="{3FDDD79A-D4D2-8821-9C65-2274992B6A77}" type="slidenum">
+            <a:fld id="{3B5D742C-62D6-0882-98E5-94D73AAB6EC1}" type="slidenum">
               <a:rPr lang="ru-ru" cap="none"/>
               <a:t>‹#›</a:t>
             </a:fld>
@@ -7527,7 +7527,7 @@
             <a:spLocks noGrp="1" noChangeArrowheads="1"/>
             <a:extLst>
               <a:ext uri="smNativeData">
-                <pr:smNativeData xmlns:pr="smNativeData" xmlns="smNativeData" val="SMDATA_15_9kV5ZhMAAAAlAAAAZAAAAA0AAAAAkAAAAJAAAACQAAAAkAAAAAAAAAABAAAAAAAAAAEAAABQAAAAAAAAAAAA4D8AAAAAAADgPwAAAAAAAOA/AAAAAAAA4D8AAAAAAADgPwAAAAAAAOA/AAAAAAAA4D8AAAAAAADgPwAAAAAAAOA/AAAAAAAA4D8CAAAAjAAAAAAAAAAAAAAAQoX0DP///wgAAAAAAAAAAAAAAAAAAAAAAAAAAAAAAAAAAAAAZAAAAAEAAABAAAAAAAAAAAAAAAAAAAAAAAAAAAAAAAAAAAAAAAAAAAAAAAAAAAAAAAAAAAAAAAAAAAAAAAAAAAAAAAAAAAAAAAAAAAAAAAAAAAAAAAAAAAAAAAAAAAAAFAAAADwAAAAAAAAAAAAAAAAAAAkUAAAAAQAAABQAAAAUAAAAFAAAAAEAAAAAAAAAZAAAAGQAAAAAAAAAZAAAAGQAAAAVAAAAYAAAAAAAAAAAAAAADwAAACADAAAAAAAAAAAAAAEAAACgMgAAVgcAAKr4//8BAAAAf39/AAEAAABkAAAAAAAAABQAAABAHwAAAAAAACYAAAAAAAAAwOD//wAAAAAmAAAAZAAAABYAAABMAAAAAAAAAAAAAAAEAAAAAAAAAAEAAABZWVkKAAAAACgAAAAoAAAAZAAAAGQAAAAAAAAAzMzMAAAAAABQAAAAUAAAAGQAAABkAAAAAAAAABcAAAAUAAAAAAAAAAAAAAD/fwAA/38AAAAAAAAJAAAABAAAAAAAAAAeAAAAaAAAAAAAAAAAAAAAAAAAAAAAAAAAAAAAECcAABAnAAAAAAAAAAAAAAAAAAAAAAAAAAAAAAAAAAAAAAAAAAAAABQAAAAAAAAAwMD/AAAAAABkAAAAMgAAAAAAAABkAAAAAAAAAH9/fwAKAAAAIgAAABgAAAAAAAAAAAAAAAAAAAAAAAAAAAAAAAAAAAAkAAAAJAAAAAAAAAAHAAAAAAAAAAAAAAAAAAAAAAAAAAAAAAAAAAAAf39/ACUAAABYAAAAAAAAAAAAAAAAAAAAAAAAAAAAAAAAAAAAAAAAAAAAAAAAAAAAAAAAAAAAAAA/AAAAAAAAAKCGAQAAAAAAAAAAAAAAAAAMAAAAAQAAAAAAAAAAAAAAAAAAAB8AAABUAAAAAAAABQAAAAEAAAAAAAAAAAAAAAAAAAAAAAAAAAAAAAAAAAAAAAAAAAAAAAJ/f38AAAAAA8zMzADAwP8Af39/AAAAAAAAAAAAAAAAAAAAAAAAAAAAIQAAABgAAAAUAAAAHjQAAEAmAAB/NwAAeikAABAAAAAmAAAACAAAADywAAAAAAAA"/>
+                <pr:smNativeData xmlns:pr="smNativeData" xmlns="smNativeData" val="SMDATA_15_bQt8ZhMAAAAlAAAAZAAAAA0AAAAAkAAAAJAAAACQAAAAkAAAAAAAAAABAAAAAAAAAAEAAABQAAAAAAAAAAAA4D8AAAAAAADgPwAAAAAAAOA/AAAAAAAA4D8AAAAAAADgPwAAAAAAAOA/AAAAAAAA4D8AAAAAAADgPwAAAAAAAOA/AAAAAAAA4D8CAAAAjAAAAAAAAAAAAAAAQoX0DP///wgAAAAAAAAAAAAAAAAAAAAAAAAAAAAAAAAAAAAAZAAAAAEAAABAAAAAAAAAAAAAAAAAAAAAAAAAAAAAAAAAAAAAAAAAAAAAAAAAAAAAAAAAAAAAAAAAAAAAAAAAAAAAAAAAAAAAAAAAAAAAAAAAAAAAAAAAAAAAAAAAAAAAFAAAADwAAAAAAAAAAAAAAAAAAAkUAAAAAQAAABQAAAAUAAAAFAAAAAEAAAAAAAAAZAAAAGQAAAAAAAAAZAAAAGQAAAAVAAAAYAAAAAAAAAAAAAAADwAAACADAAAAAAAAAAAAAAEAAACgMgAAVgcAAKr4//8BAAAAf39/AAEAAABkAAAAAAAAABQAAABAHwAAAAAAACYAAAAAAAAAwOD//wAAAAAmAAAAZAAAABYAAABMAAAAAAAAAAAAAAAEAAAAAAAAAAEAAABZWVkKAAAAACgAAAAoAAAAZAAAAGQAAAAAAAAAzMzMAAAAAABQAAAAUAAAAGQAAABkAAAAAAAAABcAAAAUAAAAAAAAAAAAAAD/fwAA/38AAAAAAAAJAAAABAAAAAAAAAAeAAAAaAAAAAAAAAAAAAAAAAAAAAAAAAAAAAAAECcAABAnAAAAAAAAAAAAAAAAAAAAAAAAAAAAAAAAAAAAAAAAAAAAABQAAAAAAAAAwMD/AAAAAABkAAAAMgAAAAAAAABkAAAAAAAAAH9/fwAKAAAAIgAAABgAAAAAAAAAAAAAAAAAAAAAAAAAAAAAAAAAAAAkAAAAJAAAAAAAAAAHAAAAAAAAAAAAAAAAAAAAAAAAAAAAAAAAAAAAf39/ACUAAABYAAAAAAAAAAAAAAAAAAAAAAAAAAAAAAAAAAAAAAAAAAAAAAAAAAAAAAAAAAAAAAA/AAAAAAAAAKCGAQAAAAAAAAAAAAAAAAAMAAAAAQAAAAAAAAAAAAAAAAAAAB8AAABUAAAAAAAABQAAAAEAAAAAAAAAAAAAAAAAAAAAAAAAAAAAAAAAAAAAAAAAAAAAAAJ/f38AAAAAA8zMzADAwP8Af39/AAAAAAAAAAAAAAAAAAAAAAAAAAAAIQAAABgAAAAUAAAAHjQAAEAmAAB/NwAAeikAABAAAAAmAAAACAAAADywAAAAAAAA"/>
               </a:ext>
             </a:extLst>
           </p:cNvSpPr>
@@ -7581,7 +7581,7 @@
               </a:spcAft>
               <a:buNone/>
             </a:pPr>
-            <a:fld id="{3FDDC532-7CD2-8833-9C65-8A668B2B6ADF}" type="slidenum">
+            <a:fld id="{3B5D0936-78D6-08FF-98E5-8EAA47AB6EDB}" type="slidenum">
               <a:rPr lang="ru-ru" cap="none"/>
               <a:t>‹#›</a:t>
             </a:fld>
@@ -7632,7 +7632,7 @@
             <a:spLocks noGrp="1" noChangeArrowheads="1"/>
             <a:extLst>
               <a:ext uri="smNativeData">
-                <pr:smNativeData xmlns:pr="smNativeData" xmlns="smNativeData" val="SMDATA_15_9kV5ZhMAAAAlAAAAZAAAAA0AAAAAkAAAAJAAAACQAAAAkAAAAAAAAAAAAAAAAAAAAAEAAABQAAAAAAAAAAAA4D8AAAAAAADgPwAAAAAAAOA/AAAAAAAA4D8AAAAAAADgPwAAAAAAAOA/AAAAAAAA4D8AAAAAAADgPwAAAAAAAOA/AAAAAAAA4D8CAAAAjAAAAAAAAAAAAAAAQoX0DP///wgAAAAAAAAAAAAAAAAAAAAAAAAAAAAAAAAAAAAAZAAAAAEAAABAAAAAAAAAAAAAAAAAAAAAAAAAAAAAAAAAAAAAAAAAAAAAAAAAAAAAAAAAAAAAAAAAAAAAAAAAAAAAAAAAAAAAAAAAAAAAAAAAAAAAAAAAAAAAAAAAAAAAFAAAADwAAAAAAAAAAAAAAAAAAAkUAAAAAQAAABQAAAAUAAAAFAAAAAEAAAAAAAAAZAAAAGQAAAAAAAAAZAAAAGQAAAAVAAAAYAAAAAAAAAAAAAAADwAAACADAAAAAAAAAAAAAAEAAACgMgAAVgcAAKr4//8BAAAAf39/AAEAAABkAAAAAAAAABQAAABAHwAAAAAAACYAAAAAAAAAwOD//wAAAAAmAAAAZAAAABYAAABMAAAAAAAAAAAAAAAEAAAAAAAAAAEAAABZWVkKAAAAACgAAAAoAAAAZAAAAGQAAAAAAAAAzMzMAAAAAABQAAAAUAAAAGQAAABkAAAAAAAAABcAAAAUAAAAAAAAAAAAAAD/fwAA/38AAAAAAAAJAAAABAAAAGdlODkeAAAAaAAAAAAAAAAAAAAAAAAAAAAAAAAAAAAAECcAABAnAAAAAAAAAAAAAAAAAAAAAAAAAAAAAAAAAAAAAAAAAAAAABQAAAAAAAAAwMD/AAAAAABkAAAAMgAAAAAAAABkAAAAAAAAAH9/fwAKAAAAIgAAABgAAAAAAAAAAAAAAAAAAAAAAAAAAAAAAAAAAAAkAAAAJAAAAAAAAAAHAAAAAAAAAAAAAAAAAAAAAAAAAAAAAAAAAAAAf39/ACUAAABYAAAAAAAAAAAAAAAAAAAAAAAAAAAAAAAAAAAAAAAAAAAAAAAAAAAAAAAAAAAAAAA/AAAAAAAAAKCGAQAAAAAAAAAAAAAAAAAMAAAAAQAAAAAAAAAAAAAAAAAAAB8AAABUAAAAAAAABQAAAAEAAAAAAAAAAAAAAAAAAAAAAAAAAAAAAAAAAAAAAAAAAAAAAAJ/f38AAAAAA8zMzADAwP8Af39/AAAAAAAAAAAAAAAAAAAAAAAAAAAAIQAAABgAAAAUAAAAFAMAALYCAAB/NwAAvwoAABAAAAAmAAAACAAAAL2/AAD/HwAA"/>
+                <pr:smNativeData xmlns:pr="smNativeData" xmlns="smNativeData" val="SMDATA_15_bQt8ZhMAAAAlAAAAZAAAAA0AAAAAkAAAAJAAAACQAAAAkAAAAAAAAAAAAAAAAAAAAAEAAABQAAAAAAAAAAAA4D8AAAAAAADgPwAAAAAAAOA/AAAAAAAA4D8AAAAAAADgPwAAAAAAAOA/AAAAAAAA4D8AAAAAAADgPwAAAAAAAOA/AAAAAAAA4D8CAAAAjAAAAAAAAAAAAAAAQoX0DP///wgAAAAAAAAAAAAAAAAAAAAAAAAAAAAAAAAAAAAAZAAAAAEAAABAAAAAAAAAAAAAAAAAAAAAAAAAAAAAAAAAAAAAAAAAAAAAAAAAAAAAAAAAAAAAAAAAAAAAAAAAAAAAAAAAAAAAAAAAAAAAAAAAAAAAAAAAAAAAAAAAAAAAFAAAADwAAAAAAAAAAAAAAAAAAAkUAAAAAQAAABQAAAAUAAAAFAAAAAEAAAAAAAAAZAAAAGQAAAAAAAAAZAAAAGQAAAAVAAAAYAAAAAAAAAAAAAAADwAAACADAAAAAAAAAAAAAAEAAACgMgAAVgcAAKr4//8BAAAAf39/AAEAAABkAAAAAAAAABQAAABAHwAAAAAAACYAAAAAAAAAwOD//wAAAAAmAAAAZAAAABYAAABMAAAAAAAAAAAAAAAEAAAAAAAAAAEAAABZWVkKAAAAACgAAAAoAAAAZAAAAGQAAAAAAAAAzMzMAAAAAABQAAAAUAAAAGQAAABkAAAAAAAAABcAAAAUAAAAAAAAAAAAAAD/fwAA/38AAAAAAAAJAAAABAAAAGdlODkeAAAAaAAAAAAAAAAAAAAAAAAAAAAAAAAAAAAAECcAABAnAAAAAAAAAAAAAAAAAAAAAAAAAAAAAAAAAAAAAAAAAAAAABQAAAAAAAAAwMD/AAAAAABkAAAAMgAAAAAAAABkAAAAAAAAAH9/fwAKAAAAIgAAABgAAAAAAAAAAAAAAAAAAAAAAAAAAAAAAAAAAAAkAAAAJAAAAAAAAAAHAAAAAAAAAAAAAAAAAAAAAAAAAAAAAAAAAAAAf39/ACUAAABYAAAAAAAAAAAAAAAAAAAAAAAAAAAAAAAAAAAAAAAAAAAAAAAAAAAAAAAAAAAAAAA/AAAAAAAAAKCGAQAAAAAAAAAAAAAAAAAMAAAAAQAAAAAAAAAAAAAAAAAAAB8AAABUAAAAAAAABQAAAAEAAAAAAAAAAAAAAAAAAAAAAAAAAAAAAAAAAAAAAAAAAAAAAAJ/f38AAAAAA8zMzADAwP8Af39/AAAAAAAAAAAAAAAAAAAAAAAAAAAAIQAAABgAAAAUAAAAFAMAALYCAAB/NwAAvwoAABAAAAAmAAAACAAAAL2/AAD/HwAA"/>
               </a:ext>
             </a:extLst>
           </p:cNvSpPr>
@@ -7802,7 +7802,7 @@
             <a:spLocks noGrp="1" noChangeArrowheads="1"/>
             <a:extLst>
               <a:ext uri="smNativeData">
-                <pr:smNativeData xmlns:pr="smNativeData" xmlns="smNativeData" val="SMDATA_15_9kV5ZhMAAAAlAAAAZAAAAA0AAAAAkAAAAJAAAACQAAAAkAAAAAAAAAAAAAAAAAAAAAEAAABQAAAAAAAAAAAA4D8AAAAAAADgPwAAAAAAAOA/AAAAAAAA4D8AAAAAAADgPwAAAAAAAOA/AAAAAAAA4D8AAAAAAADgPwAAAAAAAOA/AAAAAAAA4D8CAAAAjAAAAAAAAAAAAAAAQoX0DP///wgAAAAAAAAAAAAAAAAAAAAAAAAAAAAAAAAAAAAAZAAAAAEAAABAAAAAAAAAAAAAAAAAAAAAAAAAAAAAAAAAAAAAAAAAAAAAAAAAAAAAAAAAAAAAAAAAAAAAAAAAAAAAAAAAAAAAAAAAAAAAAAAAAAAAAAAAAAAAAAAAAAAAFAAAADwAAAAAAAAAAAAAAAAAAAkUAAAAAQAAABQAAAAUAAAAFAAAAAEAAAAAAAAAZAAAAGQAAAAAAAAAZAAAAGQAAAAVAAAAYAAAAAAAAAAAAAAADwAAACADAAAAAAAAAAAAAAEAAACgMgAAVgcAAKr4//8BAAAAf39/AAEAAABkAAAAAAAAABQAAABAHwAAAAAAACYAAAAAAAAAwOD//wAAAAAmAAAAZAAAABYAAABMAAAAAAAAAAAAAAAEAAAAAAAAAAEAAABZWVkKAAAAACgAAAAoAAAAZAAAAGQAAAAAAAAAzMzMAAAAAABQAAAAUAAAAGQAAABkAAAAAAAAABcAAAAUAAAAAAAAAAAAAAD/fwAA/38AAAAAAAAJAAAABAAAAGdlODkeAAAAaAAAAAAAAAAAAAAAAAAAAAAAAAAAAAAAECcAABAnAAAAAAAAAAAAAAAAAAAAAAAAAAAAAAAAAAAAAAAAAAAAABQAAAAAAAAAwMD/AAAAAABkAAAAMgAAAAAAAABkAAAAAAAAAH9/fwAKAAAAIgAAABgAAAAAAAAAAAAAAAAAAAAAAAAAAAAAAAAAAAAkAAAAJAAAAAAAAAAHAAAAAAAAAAAAAAAAAAAAAAAAAAAAAAAAAAAAf39/ACUAAABYAAAAAAAAAAAAAAAAAAAAAAAAAAAAAAAAAAAAAAAAAAAAAAAAAAAAAAAAAAAAAAA/AAAAAAAAAKCGAQAAAAAAAAAAAAAAAAAMAAAAAQAAAAAAAAAAAAAAAAAAAB8AAABUAAAAAAAABQAAAAEAAAAAAAAAAAAAAAAAAAAAAAAAAAAAAAAAAAAAAAAAAAAAAAJ/f38AAAAAA8zMzADAwP8Af39/AAAAAAAAAAAAAAAAAAAAAAAAAAAAIQAAABgAAAAUAAAAnAIAALMLAAAHNwAAuScAABAAAAAmAAAACAAAAL2/AAD/HwAA"/>
+                <pr:smNativeData xmlns:pr="smNativeData" xmlns="smNativeData" val="SMDATA_15_bQt8ZhMAAAAlAAAAZAAAAA0AAAAAkAAAAJAAAACQAAAAkAAAAAAAAAAAAAAAAAAAAAEAAABQAAAAAAAAAAAA4D8AAAAAAADgPwAAAAAAAOA/AAAAAAAA4D8AAAAAAADgPwAAAAAAAOA/AAAAAAAA4D8AAAAAAADgPwAAAAAAAOA/AAAAAAAA4D8CAAAAjAAAAAAAAAAAAAAAQoX0DP///wgAAAAAAAAAAAAAAAAAAAAAAAAAAAAAAAAAAAAAZAAAAAEAAABAAAAAAAAAAAAAAAAAAAAAAAAAAAAAAAAAAAAAAAAAAAAAAAAAAAAAAAAAAAAAAAAAAAAAAAAAAAAAAAAAAAAAAAAAAAAAAAAAAAAAAAAAAAAAAAAAAAAAFAAAADwAAAAAAAAAAAAAAAAAAAkUAAAAAQAAABQAAAAUAAAAFAAAAAEAAAAAAAAAZAAAAGQAAAAAAAAAZAAAAGQAAAAVAAAAYAAAAAAAAAAAAAAADwAAACADAAAAAAAAAAAAAAEAAACgMgAAVgcAAKr4//8BAAAAf39/AAEAAABkAAAAAAAAABQAAABAHwAAAAAAACYAAAAAAAAAwOD//wAAAAAmAAAAZAAAABYAAABMAAAAAAAAAAAAAAAEAAAAAAAAAAEAAABZWVkKAAAAACgAAAAoAAAAZAAAAGQAAAAAAAAAzMzMAAAAAABQAAAAUAAAAGQAAABkAAAAAAAAABcAAAAUAAAAAAAAAAAAAAD/fwAA/38AAAAAAAAJAAAABAAAAGdlODkeAAAAaAAAAAAAAAAAAAAAAAAAAAAAAAAAAAAAECcAABAnAAAAAAAAAAAAAAAAAAAAAAAAAAAAAAAAAAAAAAAAAAAAABQAAAAAAAAAwMD/AAAAAABkAAAAMgAAAAAAAABkAAAAAAAAAH9/fwAKAAAAIgAAABgAAAAAAAAAAAAAAAAAAAAAAAAAAAAAAAAAAAAkAAAAJAAAAAAAAAAHAAAAAAAAAAAAAAAAAAAAAAAAAAAAAAAAAAAAf39/ACUAAABYAAAAAAAAAAAAAAAAAAAAAAAAAAAAAAAAAAAAAAAAAAAAAAAAAAAAAAAAAAAAAAA/AAAAAAAAAKCGAQAAAAAAAAAAAAAAAAAMAAAAAQAAAAAAAAAAAAAAAAAAAB8AAABUAAAAAAAABQAAAAEAAAAAAAAAAAAAAAAAAAAAAAAAAAAAAAAAAAAAAAAAAAAAAAJ/f38AAAAAA8zMzADAwP8Af39/AAAAAAAAAAAAAAAAAAAAAAAAAAAAIQAAABgAAAAUAAAAnAIAALMLAAAHNwAAuScAABAAAAAmAAAACAAAAL2/AAD/HwAA"/>
               </a:ext>
             </a:extLst>
           </p:cNvSpPr>
@@ -8068,7 +8068,7 @@
             <a:spLocks noGrp="1" noChangeArrowheads="1"/>
             <a:extLst>
               <a:ext uri="smNativeData">
-                <pr:smNativeData xmlns:pr="smNativeData" xmlns="smNativeData" val="SMDATA_15_9kV5ZhMAAAAlAAAAZAAAAA0AAAAAkAAAAJAAAACQAAAAkAAAAAAAAAABAAAAAAAAAAEAAABQAAAAAAAAAAAA4D8AAAAAAADgPwAAAAAAAOA/AAAAAAAA4D8AAAAAAADgPwAAAAAAAOA/AAAAAAAA4D8AAAAAAADgPwAAAAAAAOA/AAAAAAAA4D8CAAAAjAAAAAAAAAAAAAAAQoX0DP///wgAAAAAAAAAAAAAAAAAAAAAAAAAAAAAAAAAAAAAZAAAAAEAAABAAAAAAAAAAAAAAAAAAAAAAAAAAAAAAAAAAAAAAAAAAAAAAAAAAAAAAAAAAAAAAAAAAAAAAAAAAAAAAAAAAAAAAAAAAAAAAAAAAAAAAAAAAAAAAAAAAAAAFAAAADwAAAAAAAAAAAAAAAAAAAkUAAAAAQAAABQAAAAUAAAAFAAAAAEAAAAAAAAAZAAAAGQAAAAAAAAAZAAAAGQAAAAVAAAAYAAAAAAAAAAAAAAADwAAACADAAAAAAAAAAAAAAEAAACgMgAAVgcAAKr4//8BAAAAf39/AAEAAABkAAAAAAAAABQAAABAHwAAAAAAACYAAAAAAAAAwOD//wAAAAAmAAAAZAAAABYAAABMAAAAAAAAAAAAAAAEAAAAAAAAAAEAAABZWVkKAAAAACgAAAAoAAAAZAAAAGQAAAAAAAAAzMzMAAAAAABQAAAAUAAAAGQAAABkAAAAAAAAABcAAAAUAAAAAAAAAAAAAAD/fwAA/38AAAAAAAAJAAAABAAAAG0AOwAeAAAAaAAAAAAAAAAAAAAAAAAAAAAAAAAAAAAAECcAABAnAAAAAAAAAAAAAAAAAAAAAAAAAAAAAAAAAAAAAAAAAAAAABQAAAAAAAAAwMD/AAAAAABkAAAAMgAAAAAAAABkAAAAAAAAAH9/fwAKAAAAIgAAABgAAAAAAAAAAAAAAAAAAAAAAAAAAAAAAAAAAAAkAAAAJAAAAAAAAAAHAAAAAAAAAAAAAAAAAAAAAAAAAAAAAAAAAAAAf39/ACUAAABYAAAAAAAAAAAAAAAAAAAAAAAAAAAAAAAAAAAAAAAAAAAAAAAAAAAAAAAAAAAAAAA/AAAAAAAAAKCGAQAAAAAAAAAAAAAAAAAMAAAAAQAAAAAAAAAAAAAAAAAAAB8AAABUAAAAAAAABQAAAAEAAAAAAAAAAAAAAAAAAAAAAAAAAAAAAAAAAAAAAAAAAAAAAAJ/f38AAAAAA8zMzADAwP8Af39/AAAAAAAAAAAAAAAAAAAAAAAAAAAAIQAAABgAAAAUAAAAHjQAAEAmAAB/NwAAeikAABAAAAAmAAAACAAAAL2/AAD/HwAA"/>
+                <pr:smNativeData xmlns:pr="smNativeData" xmlns="smNativeData" val="SMDATA_15_bQt8ZhMAAAAlAAAAZAAAAA0AAAAAkAAAAJAAAACQAAAAkAAAAAAAAAABAAAAAAAAAAEAAABQAAAAAAAAAAAA4D8AAAAAAADgPwAAAAAAAOA/AAAAAAAA4D8AAAAAAADgPwAAAAAAAOA/AAAAAAAA4D8AAAAAAADgPwAAAAAAAOA/AAAAAAAA4D8CAAAAjAAAAAAAAAAAAAAAQoX0DP///wgAAAAAAAAAAAAAAAAAAAAAAAAAAAAAAAAAAAAAZAAAAAEAAABAAAAAAAAAAAAAAAAAAAAAAAAAAAAAAAAAAAAAAAAAAAAAAAAAAAAAAAAAAAAAAAAAAAAAAAAAAAAAAAAAAAAAAAAAAAAAAAAAAAAAAAAAAAAAAAAAAAAAFAAAADwAAAAAAAAAAAAAAAAAAAkUAAAAAQAAABQAAAAUAAAAFAAAAAEAAAAAAAAAZAAAAGQAAAAAAAAAZAAAAGQAAAAVAAAAYAAAAAAAAAAAAAAADwAAACADAAAAAAAAAAAAAAEAAACgMgAAVgcAAKr4//8BAAAAf39/AAEAAABkAAAAAAAAABQAAABAHwAAAAAAACYAAAAAAAAAwOD//wAAAAAmAAAAZAAAABYAAABMAAAAAAAAAAAAAAAEAAAAAAAAAAEAAABZWVkKAAAAACgAAAAoAAAAZAAAAGQAAAAAAAAAzMzMAAAAAABQAAAAUAAAAGQAAABkAAAAAAAAABcAAAAUAAAAAAAAAAAAAAD/fwAA/38AAAAAAAAJAAAABAAAAG0AOwAeAAAAaAAAAAAAAAAAAAAAAAAAAAAAAAAAAAAAECcAABAnAAAAAAAAAAAAAAAAAAAAAAAAAAAAAAAAAAAAAAAAAAAAABQAAAAAAAAAwMD/AAAAAABkAAAAMgAAAAAAAABkAAAAAAAAAH9/fwAKAAAAIgAAABgAAAAAAAAAAAAAAAAAAAAAAAAAAAAAAAAAAAAkAAAAJAAAAAAAAAAHAAAAAAAAAAAAAAAAAAAAAAAAAAAAAAAAAAAAf39/ACUAAABYAAAAAAAAAAAAAAAAAAAAAAAAAAAAAAAAAAAAAAAAAAAAAAAAAAAAAAAAAAAAAAA/AAAAAAAAAKCGAQAAAAAAAAAAAAAAAAAMAAAAAQAAAAAAAAAAAAAAAAAAAB8AAABUAAAAAAAABQAAAAEAAAAAAAAAAAAAAAAAAAAAAAAAAAAAAAAAAAAAAAAAAAAAAAJ/f38AAAAAA8zMzADAwP8Af39/AAAAAAAAAAAAAAAAAAAAAAAAAAAAIQAAABgAAAAUAAAAHjQAAEAmAAB/NwAAeikAABAAAAAmAAAACAAAAL2/AAD/HwAA"/>
               </a:ext>
             </a:extLst>
           </p:cNvSpPr>
@@ -8179,7 +8179,7 @@
               </a:spcAft>
               <a:buNone/>
             </a:pPr>
-            <a:fld id="{3FDDFB4B-05D2-880D-9C65-F358B52B6AA6}" type="slidenum">
+            <a:fld id="{3B5D4F91-DFD6-08B9-98E5-29EC01AB6E7C}" type="slidenum">
               <a:rPr lang="ru-ru" cap="none"/>
               <a:t/>
             </a:fld>
@@ -8836,7 +8836,7 @@
             <a:spLocks noGrp="1" noChangeArrowheads="1"/>
             <a:extLst>
               <a:ext uri="smNativeData">
-                <pr:smNativeData xmlns:pr="smNativeData" xmlns="smNativeData" val="SMDATA_15_9kV5ZhMAAAAlAAAAZAAAAA0AAAAAkAAAAJAAAACQAAAAkAAAAAAAAAAAAAAAAAAAAAEAAABQAAAAAAAAAAAA4D8AAAAAAADgPwAAAAAAAOA/AAAAAAAA4D8AAAAAAADgPwAAAAAAAOA/AAAAAAAA4D8AAAAAAADgPwAAAAAAAOA/AAAAAAAA4D8CAAAAjAAAAAAAAAAAAAAAQoX0DP///wgAAAAAAAAAAAAAAAAAAAAAAAAAAAAAAAAAAAAAZAAAAAEAAABAAAAAAAAAAAAAAAAAAAAAAAAAAAAAAAAAAAAAAAAAAAAAAAAAAAAAAAAAAAAAAAAAAAAAAAAAAAAAAAAAAAAAAAAAAAAAAAAAAAAAAAAAAAAAAAAAAAAAFAAAADwAAAAAAAAAAAAAAAAAAAkUAAAAAQAAABQAAAAUAAAAFAAAAAEAAAAAAAAAZAAAAGQAAAAAAAAAZAAAAGQAAAAVAAAAYAAAAAAAAAAAAAAADwAAACADAAAAAAAAAAAAAAEAAACgMgAAVgcAAKr4//8BAAAAf39/AAEAAABkAAAAAAAAABQAAABAHwAAAAAAACYAAAAAAAAAwOD//wAAAAAmAAAAZAAAABYAAABMAAAAAAAAAAAAAAAEAAAAAAAAAAEAAABZWVkKAAAAACgAAAAoAAAAZAAAAGQAAAAAAAAAzMzMAAAAAABQAAAAUAAAAGQAAABkAAAAAAAAABcAAAAUAAAAAAAAAAAAAAD/fwAA/38AAAAAAAAJAAAABAAAAAAAAAAeAAAAaAAAAAAAAAAAAAAAAAAAAAAAAAAAAAAAECcAABAnAAAAAAAAAAAAAAAAAAAAAAAAAAAAAAAAAAAAAAAAAAAAABQAAAAAAAAAwMD/AAAAAABkAAAAMgAAAAAAAABkAAAAAAAAAH9/fwAKAAAAIgAAABgAAAAAAAAAAAAAAAAAAAAAAAAAAAAAAAAAAAAkAAAAJAAAAAAAAAAHAAAAAAAAAAAAAAAAAAAAAAAAAAAAAAAAAAAAf39/ACUAAABYAAAAAAAAAAAAAAAAAAAAAAAAAAAAAAAAAAAAAAAAAAAAAAAAAAAAAAAAAAAAAAA/AAAAAAAAAKCGAQAAAAAAAAAAAAAAAAAMAAAAAQAAAAAAAAAAAAAAAAAAAB8AAABUAAAAQoX0Bf///wEAAAAAAAAAAAAAAAAAAAAAAAAAAAAAAAAAAAAAAAAAAAAAAAJ/f38AWVlZA8zMzADAwP8Af39/AAAAAAAAAAAAAAAAAAAAAAAAAAAAIQAAABgAAAAUAAAA5wQAAD8jAAD6IwAAvykAABAAAAAmAAAACAAAADwwAAAAAAAA"/>
+                <pr:smNativeData xmlns:pr="smNativeData" xmlns="smNativeData" val="SMDATA_15_bQt8ZhMAAAAlAAAAZAAAAA0AAAAAkAAAAJAAAACQAAAAkAAAAAAAAAAAAAAAAAAAAAEAAABQAAAAAAAAAAAA4D8AAAAAAADgPwAAAAAAAOA/AAAAAAAA4D8AAAAAAADgPwAAAAAAAOA/AAAAAAAA4D8AAAAAAADgPwAAAAAAAOA/AAAAAAAA4D8CAAAAjAAAAAAAAAAAAAAAQoX0DP///wgAAAAAAAAAAAAAAAAAAAAAAAAAAAAAAAAAAAAAZAAAAAEAAABAAAAAAAAAAAAAAAAAAAAAAAAAAAAAAAAAAAAAAAAAAAAAAAAAAAAAAAAAAAAAAAAAAAAAAAAAAAAAAAAAAAAAAAAAAAAAAAAAAAAAAAAAAAAAAAAAAAAAFAAAADwAAAAAAAAAAAAAAAAAAAkUAAAAAQAAABQAAAAUAAAAFAAAAAEAAAAAAAAAZAAAAGQAAAAAAAAAZAAAAGQAAAAVAAAAYAAAAAAAAAAAAAAADwAAACADAAAAAAAAAAAAAAEAAACgMgAAVgcAAKr4//8BAAAAf39/AAEAAABkAAAAAAAAABQAAABAHwAAAAAAACYAAAAAAAAAwOD//wAAAAAmAAAAZAAAABYAAABMAAAAAAAAAAAAAAAEAAAAAAAAAAEAAABZWVkKAAAAACgAAAAoAAAAZAAAAGQAAAAAAAAAzMzMAAAAAABQAAAAUAAAAGQAAABkAAAAAAAAABcAAAAUAAAAAAAAAAAAAAD/fwAA/38AAAAAAAAJAAAABAAAAAAAAAAeAAAAaAAAAAAAAAAAAAAAAAAAAAAAAAAAAAAAECcAABAnAAAAAAAAAAAAAAAAAAAAAAAAAAAAAAAAAAAAAAAAAAAAABQAAAAAAAAAwMD/AAAAAABkAAAAMgAAAAAAAABkAAAAAAAAAH9/fwAKAAAAIgAAABgAAAAAAAAAAAAAAAAAAAAAAAAAAAAAAAAAAAAkAAAAJAAAAAAAAAAHAAAAAAAAAAAAAAAAAAAAAAAAAAAAAAAAAAAAf39/ACUAAABYAAAAAAAAAAAAAAAAAAAAAAAAAAAAAAAAAAAAAAAAAAAAAAAAAAAAAAAAAAAAAAA/AAAAAAAAAKCGAQAAAAAAAAAAAAAAAAAMAAAAAQAAAAAAAAAAAAAAAAAAAB8AAABUAAAAQoX0Bf///wEAAAAAAAAAAAAAAAAAAAAAAAAAAAAAAAAAAAAAAAAAAAAAAAJ/f38AWVlZA8zMzADAwP8Af39/AAAAAAAAAAAAAAAAAAAAAAAAAAAAIQAAABgAAAAUAAAA5wQAAD8jAAD6IwAAvykAABAAAAAmAAAACAAAADwwAAAAAAAA"/>
               </a:ext>
             </a:extLst>
           </p:cNvSpPr>
@@ -8877,7 +8877,7 @@
             <a:spLocks noGrp="1" noChangeArrowheads="1"/>
             <a:extLst>
               <a:ext uri="smNativeData">
-                <pr:smNativeData xmlns:pr="smNativeData" xmlns="smNativeData" val="SMDATA_15_9kV5ZhMAAAAlAAAAZAAAAA0AAAAAkAAAAJAAAACQAAAAkAAAAAAAAAAAAAAAAAAAAAEAAABQAAAAAAAAAAAA4D8AAAAAAADgPwAAAAAAAOA/AAAAAAAA4D8AAAAAAADgPwAAAAAAAOA/AAAAAAAA4D8AAAAAAADgPwAAAAAAAOA/AAAAAAAA4D8CAAAAjAAAAAAAAAAAAAAAQoX0DP///wgAAAAAAAAAAAAAAAAAAAAAAAAAAAAAAAAAAAAAZAAAAAEAAABAAAAAAAAAAAAAAAAAAAAAAAAAAAAAAAAAAAAAAAAAAAAAAAAAAAAAAAAAAAAAAAAAAAAAAAAAAAAAAAAAAAAAAAAAAAAAAAAAAAAAAAAAAAAAAAAAAAAAFAAAADwAAAAAAAAAAAAAAAAAAAkUAAAAAQAAABQAAAAUAAAAFAAAAAEAAAAAAAAAZAAAAGQAAAAAAAAAZAAAAGQAAAAVAAAAYAAAAAAAAAAAAAAADwAAACADAAAAAAAAAAAAAAEAAACgMgAAVgcAAKr4//8BAAAAf39/AAEAAABkAAAAAAAAABQAAABAHwAAAAAAACYAAAAAAAAAwOD//wAAAAAmAAAAZAAAABYAAABMAAAAAAAAAAAAAAAEAAAAAAAAAAEAAABZWVkKAAAAACgAAAAoAAAAZAAAAGQAAAAAAAAAzMzMAAAAAABQAAAAUAAAAGQAAABkAAAAAAAAABcAAAAUAAAAAAAAAAAAAAD/fwAA/38AAAAAAAAJAAAABAAAAAAAAAAeAAAAaAAAAAAAAAAAAAAAAAAAAAAAAAAAAAAAECcAABAnAAAAAAAAAAAAAAAAAAAAAAAAAAAAAAAAAAAAAAAAAAAAABQAAAAAAAAAwMD/AAAAAABkAAAAMgAAAAAAAABkAAAAAAAAAH9/fwAKAAAAIgAAABgAAAAAAAAAAAAAAAAAAAAAAAAAAAAAAAAAAAAkAAAAJAAAAAAAAAAHAAAAAAAAAAAAAAAAAAAAAAAAAAAAAAAAAAAAf39/ACUAAABYAAAAAAAAAAAAAAAAAAAAAAAAAAAAAAAAAAAAAAAAAAAAAAAAAAAAAAAAAAAAAAA/AAAAAAAAAKCGAQAAAAAAAAAAAAAAAAAMAAAAAQAAAAAAAAAAAAAAAAAAAB8AAABUAAAAQoX0Bf///wEAAAAAAAAAAAAAAAAAAAAAAAAAAAAAAAAAAAAAAAAAAAAAAAJ/f38AWVlZA8zMzADAwP8Af39/AAAAAAAAAAAAAAAAAAAAAAAAAAAAIQAAABgAAAAUAAAA5wQAAMMPAACROAAAfyQAABAAAAAmAAAACAAAADwwAAAAAAAA"/>
+                <pr:smNativeData xmlns:pr="smNativeData" xmlns="smNativeData" val="SMDATA_15_bQt8ZhMAAAAlAAAAZAAAAA0AAAAAkAAAAJAAAACQAAAAkAAAAAAAAAAAAAAAAAAAAAEAAABQAAAAAAAAAAAA4D8AAAAAAADgPwAAAAAAAOA/AAAAAAAA4D8AAAAAAADgPwAAAAAAAOA/AAAAAAAA4D8AAAAAAADgPwAAAAAAAOA/AAAAAAAA4D8CAAAAjAAAAAAAAAAAAAAAQoX0DP///wgAAAAAAAAAAAAAAAAAAAAAAAAAAAAAAAAAAAAAZAAAAAEAAABAAAAAAAAAAAAAAAAAAAAAAAAAAAAAAAAAAAAAAAAAAAAAAAAAAAAAAAAAAAAAAAAAAAAAAAAAAAAAAAAAAAAAAAAAAAAAAAAAAAAAAAAAAAAAAAAAAAAAFAAAADwAAAAAAAAAAAAAAAAAAAkUAAAAAQAAABQAAAAUAAAAFAAAAAEAAAAAAAAAZAAAAGQAAAAAAAAAZAAAAGQAAAAVAAAAYAAAAAAAAAAAAAAADwAAACADAAAAAAAAAAAAAAEAAACgMgAAVgcAAKr4//8BAAAAf39/AAEAAABkAAAAAAAAABQAAABAHwAAAAAAACYAAAAAAAAAwOD//wAAAAAmAAAAZAAAABYAAABMAAAAAAAAAAAAAAAEAAAAAAAAAAEAAABZWVkKAAAAACgAAAAoAAAAZAAAAGQAAAAAAAAAzMzMAAAAAABQAAAAUAAAAGQAAABkAAAAAAAAABcAAAAUAAAAAAAAAAAAAAD/fwAA/38AAAAAAAAJAAAABAAAAAAAAAAeAAAAaAAAAAAAAAAAAAAAAAAAAAAAAAAAAAAAECcAABAnAAAAAAAAAAAAAAAAAAAAAAAAAAAAAAAAAAAAAAAAAAAAABQAAAAAAAAAwMD/AAAAAABkAAAAMgAAAAAAAABkAAAAAAAAAH9/fwAKAAAAIgAAABgAAAAAAAAAAAAAAAAAAAAAAAAAAAAAAAAAAAAkAAAAJAAAAAAAAAAHAAAAAAAAAAAAAAAAAAAAAAAAAAAAAAAAAAAAf39/ACUAAABYAAAAAAAAAAAAAAAAAAAAAAAAAAAAAAAAAAAAAAAAAAAAAAAAAAAAAAAAAAAAAAA/AAAAAAAAAKCGAQAAAAAAAAAAAAAAAAAMAAAAAQAAAAAAAAAAAAAAAAAAAB8AAABUAAAAQoX0Bf///wEAAAAAAAAAAAAAAAAAAAAAAAAAAAAAAAAAAAAAAAAAAAAAAAJ/f38AWVlZA8zMzADAwP8Af39/AAAAAAAAAAAAAAAAAAAAAAAAAAAAIQAAABgAAAAUAAAA5wQAAMMPAACROAAAfyQAABAAAAAmAAAACAAAADwwAAAAAAAA"/>
               </a:ext>
             </a:extLst>
           </p:cNvSpPr>
@@ -8966,7 +8966,7 @@
             <a:spLocks noGrp="1" noChangeArrowheads="1"/>
             <a:extLst>
               <a:ext uri="smNativeData">
-                <pr:smNativeData xmlns:pr="smNativeData" xmlns="smNativeData" val="SMDATA_15_9kV5ZhMAAAAlAAAAZAAAAA0AAAAAkAAAAJAAAACQAAAAkAAAAAAAAAAAAAAAAAAAAAEAAABQAAAAAAAAAAAA4D8AAAAAAADgPwAAAAAAAOA/AAAAAAAA4D8AAAAAAADgPwAAAAAAAOA/AAAAAAAA4D8AAAAAAADgPwAAAAAAAOA/AAAAAAAA4D8CAAAAjAAAAAAAAAAAAAAAQoX0DP///wgAAAAAAAAAAAAAAAAAAAAAAAAAAAAAAAAAAAAAZAAAAAEAAABAAAAAAAAAAAAAAAAAAAAAAAAAAAAAAAAAAAAAAAAAAAAAAAAAAAAAAAAAAAAAAAAAAAAAAAAAAAAAAAAAAAAAAAAAAAAAAAAAAAAAAAAAAAAAAAAAAAAAFAAAADwAAAAAAAAAAAAAAAAAAAkUAAAAAQAAABQAAAAUAAAAFAAAAAEAAAAAAAAAZAAAAGQAAAAAAAAAZAAAAGQAAAAVAAAAYAAAAAAAAAAAAAAADwAAACADAAAAAAAAAAAAAAEAAACgMgAAVgcAAKr4//8BAAAAf39/AAEAAABkAAAAAAAAABQAAABAHwAAAAAAACYAAAAAAAAAwOD//wAAAAAmAAAAZAAAABYAAABMAAAAAAAAAAAAAAAEAAAAAAAAAAEAAABZWVkKAAAAACgAAAAoAAAAZAAAAGQAAAAAAAAAzMzMAAAAAABQAAAAUAAAAGQAAABkAAAAAAAAABcAAAAUAAAAAAAAAAAAAAD/fwAA/38AAAAAAAAJAAAABAAAAAAAAAAeAAAAaAAAAAAAAAAAAAAAAAAAAAAAAAAAAAAAECcAABAnAAAAAAAAAAAAAAAAAAAAAAAAAAAAAAAAAAAAAAAAAAAAABQAAAAAAAAAwMD/AAAAAABkAAAAMgAAAAAAAABkAAAAAAAAAH9/fwAKAAAAIgAAABgAAAAAAAAAAAAAAAAAAAAAAAAAAAAAAAAAAAAkAAAAJAAAAAAAAAAHAAAAAAAAAAAAAAAAAAAAAAAAAAAAAAAAAAAAf39/ACUAAABYAAAAAAAAAAAAAAAAAAAAAAAAAAAAAAAAAAAAAAAAAAAAAAAAAAAAAAAAAAAAAAA/AAAAAAAAAKCGAQAAAAAAAAAAAAAAAAAMAAAAAQAAAAAAAAAAAAAAAAAAAB8AAABUAAAAAAAABQAAAAEAAAAAAAAAAAAAAAAAAAAAAAAAAAAAAAAAAAAAAAAAAAAAAAJ/f38AWVlZA8zMzADAwP8Af39/AAAAAAAAAAAAAAAAAAAAAAAAAAAAIQAAABgAAAAUAAAAFAMAALYCAAB/NwAAvwoAABAAAAAmAAAACAAAAAAAAAAAAAAA"/>
+                <pr:smNativeData xmlns:pr="smNativeData" xmlns="smNativeData" val="SMDATA_15_bQt8ZhMAAAAlAAAAZAAAAA0AAAAAkAAAAJAAAACQAAAAkAAAAAAAAAAAAAAAAAAAAAEAAABQAAAAAAAAAAAA4D8AAAAAAADgPwAAAAAAAOA/AAAAAAAA4D8AAAAAAADgPwAAAAAAAOA/AAAAAAAA4D8AAAAAAADgPwAAAAAAAOA/AAAAAAAA4D8CAAAAjAAAAAAAAAAAAAAAQoX0DP///wgAAAAAAAAAAAAAAAAAAAAAAAAAAAAAAAAAAAAAZAAAAAEAAABAAAAAAAAAAAAAAAAAAAAAAAAAAAAAAAAAAAAAAAAAAAAAAAAAAAAAAAAAAAAAAAAAAAAAAAAAAAAAAAAAAAAAAAAAAAAAAAAAAAAAAAAAAAAAAAAAAAAAFAAAADwAAAAAAAAAAAAAAAAAAAkUAAAAAQAAABQAAAAUAAAAFAAAAAEAAAAAAAAAZAAAAGQAAAAAAAAAZAAAAGQAAAAVAAAAYAAAAAAAAAAAAAAADwAAACADAAAAAAAAAAAAAAEAAACgMgAAVgcAAKr4//8BAAAAf39/AAEAAABkAAAAAAAAABQAAABAHwAAAAAAACYAAAAAAAAAwOD//wAAAAAmAAAAZAAAABYAAABMAAAAAAAAAAAAAAAEAAAAAAAAAAEAAABZWVkKAAAAACgAAAAoAAAAZAAAAGQAAAAAAAAAzMzMAAAAAABQAAAAUAAAAGQAAABkAAAAAAAAABcAAAAUAAAAAAAAAAAAAAD/fwAA/38AAAAAAAAJAAAABAAAAAAAAAAeAAAAaAAAAAAAAAAAAAAAAAAAAAAAAAAAAAAAECcAABAnAAAAAAAAAAAAAAAAAAAAAAAAAAAAAAAAAAAAAAAAAAAAABQAAAAAAAAAwMD/AAAAAABkAAAAMgAAAAAAAABkAAAAAAAAAH9/fwAKAAAAIgAAABgAAAAAAAAAAAAAAAAAAAAAAAAAAAAAAAAAAAAkAAAAJAAAAAAAAAAHAAAAAAAAAAAAAAAAAAAAAAAAAAAAAAAAAAAAf39/ACUAAABYAAAAAAAAAAAAAAAAAAAAAAAAAAAAAAAAAAAAAAAAAAAAAAAAAAAAAAAAAAAAAAA/AAAAAAAAAKCGAQAAAAAAAAAAAAAAAAAMAAAAAQAAAAAAAAAAAAAAAAAAAB8AAABUAAAAQoX0Bf///wEAAAAAAAAAAAAAAAAAAAAAAAAAAAAAAAAAAAAAAAAAAAAAAAJ/f38AWVlZA8zMzADAwP8Af39/AAAAAAAAAAAAAAAAAAAAAAAAAAAAIQAAABgAAAAUAAAAFAMAALYCAAB/NwAAvwoAABAAAAAmAAAACAAAAAAAAAAAAAAA"/>
               </a:ext>
             </a:extLst>
           </p:cNvSpPr>
@@ -8993,7 +8993,7 @@
             <a:spLocks noGrp="1" noChangeArrowheads="1"/>
             <a:extLst>
               <a:ext uri="smNativeData">
-                <pr:smNativeData xmlns:pr="smNativeData" xmlns="smNativeData" val="SMDATA_15_9kV5ZhMAAAAlAAAAZAAAAA0AAAAAkAAAAJAAAACQAAAAkAAAAAAAAAAAAAAAAAAAAAEAAABQAAAAAAAAAAAA4D8AAAAAAADgPwAAAAAAAOA/AAAAAAAA4D8AAAAAAADgPwAAAAAAAOA/AAAAAAAA4D8AAAAAAADgPwAAAAAAAOA/AAAAAAAA4D8CAAAAjAAAAAAAAAAAAAAAQoX0DP///wgAAAAAAAAAAAAAAAAAAAAAAAAAAAAAAAAAAAAAZAAAAAEAAABAAAAAAAAAAAAAAAAAAAAAAAAAAAAAAAAAAAAAAAAAAAAAAAAAAAAAAAAAAAAAAAAAAAAAAAAAAAAAAAAAAAAAAAAAAAAAAAAAAAAAAAAAAAAAAAAAAAAAFAAAADwAAAAAAAAAAAAAAAAAAAkUAAAAAQAAABQAAAAUAAAAFAAAAAEAAAAAAAAAZAAAAGQAAAAAAAAAZAAAAGQAAAAVAAAAYAAAAAAAAAAAAAAADwAAACADAAAAAAAAAAAAAAEAAACgMgAAVgcAAKr4//8BAAAAf39/AAEAAABkAAAAAAAAABQAAABAHwAAAAAAACYAAAAAAAAAwOD//wAAAAAmAAAAZAAAABYAAABMAAAAAAAAAAAAAAAEAAAAAAAAAAEAAABZWVkKAAAAACgAAAAoAAAAZAAAAGQAAAAAAAAAzMzMAAAAAABQAAAAUAAAAGQAAABkAAAAAAAAABcAAAAUAAAAAAAAAAAAAAD/fwAA/38AAAAAAAAJAAAABAAAAAAAAAAeAAAAaAAAAAAAAAAAAAAAAAAAAAAAAAAAAAAAECcAABAnAAAAAAAAAAAAAAAAAAAAAAAAAAAAAAAAAAAAAAAAAAAAABQAAAAAAAAAwMD/AAAAAABkAAAAMgAAAAAAAABkAAAAAAAAAH9/fwAKAAAAIgAAABgAAAAAAAAAAAAAAAAAAAAAAAAAAAAAAAAAAAAkAAAAJAAAAAAAAAAHAAAAAAAAAAAAAAAAAAAAAAAAAAAAAAAAAAAAf39/ACUAAABYAAAAAAAAAAAAAAAAAAAAAAAAAAAAAAAAAAAAAAAAAAAAAAAAAAAAAAAAAAAAAAA/AAAAAAAAAKCGAQAAAAAAAAAAAAAAAAAMAAAAAQAAAAAAAAAAAAAAAAAAAB8AAABUAAAAAAAABQAAAAEAAAAAAAAAAAAAAAAAAAAAAAAAAAAAAAAAAAAAAAAAAAAAAAJ/f38AWVlZA8zMzADAwP8Af39/AAAAAAAAAAAAAAAAAAAAAAAAAAAAIQAAABgAAAAUAAAAFAMAALMLAAB/NwAAuScAABAAAAAmAAAACAAAAAAAAAAAAAAA"/>
+                <pr:smNativeData xmlns:pr="smNativeData" xmlns="smNativeData" val="SMDATA_15_bQt8ZhMAAAAlAAAAZAAAAA0AAAAAkAAAAJAAAACQAAAAkAAAAAAAAAAAAAAAAAAAAAEAAABQAAAAAAAAAAAA4D8AAAAAAADgPwAAAAAAAOA/AAAAAAAA4D8AAAAAAADgPwAAAAAAAOA/AAAAAAAA4D8AAAAAAADgPwAAAAAAAOA/AAAAAAAA4D8CAAAAjAAAAAAAAAAAAAAAQoX0DP///wgAAAAAAAAAAAAAAAAAAAAAAAAAAAAAAAAAAAAAZAAAAAEAAABAAAAAAAAAAAAAAAAAAAAAAAAAAAAAAAAAAAAAAAAAAAAAAAAAAAAAAAAAAAAAAAAAAAAAAAAAAAAAAAAAAAAAAAAAAAAAAAAAAAAAAAAAAAAAAAAAAAAAFAAAADwAAAAAAAAAAAAAAAAAAAkUAAAAAQAAABQAAAAUAAAAFAAAAAEAAAAAAAAAZAAAAGQAAAAAAAAAZAAAAGQAAAAVAAAAYAAAAAAAAAAAAAAADwAAACADAAAAAAAAAAAAAAEAAACgMgAAVgcAAKr4//8BAAAAf39/AAEAAABkAAAAAAAAABQAAABAHwAAAAAAACYAAAAAAAAAwOD//wAAAAAmAAAAZAAAABYAAABMAAAAAAAAAAAAAAAEAAAAAAAAAAEAAABZWVkKAAAAACgAAAAoAAAAZAAAAGQAAAAAAAAAzMzMAAAAAABQAAAAUAAAAGQAAABkAAAAAAAAABcAAAAUAAAAAAAAAAAAAAD/fwAA/38AAAAAAAAJAAAABAAAAAAAAAAeAAAAaAAAAAAAAAAAAAAAAAAAAAAAAAAAAAAAECcAABAnAAAAAAAAAAAAAAAAAAAAAAAAAAAAAAAAAAAAAAAAAAAAABQAAAAAAAAAwMD/AAAAAABkAAAAMgAAAAAAAABkAAAAAAAAAH9/fwAKAAAAIgAAABgAAAAAAAAAAAAAAAAAAAAAAAAAAAAAAAAAAAAkAAAAJAAAAAAAAAAHAAAAAAAAAAAAAAAAAAAAAAAAAAAAAAAAAAAAf39/ACUAAABYAAAAAAAAAAAAAAAAAAAAAAAAAAAAAAAAAAAAAAAAAAAAAAAAAAAAAAAAAAAAAAA/AAAAAAAAAKCGAQAAAAAAAAAAAAAAAAAMAAAAAQAAAAAAAAAAAAAAAAAAAB8AAABUAAAAQoX0Bf///wEAAAAAAAAAAAAAAAAAAAAAAAAAAAAAAAAAAAAAAAAAAAAAAAJ/f38AWVlZA8zMzADAwP8Af39/AAAAAAAAAAAAAAAAAAAAAAAAAAAAIQAAABgAAAAUAAAAFAMAALMLAAB/NwAAuScAABAAAAAmAAAACAAAAAAAAAAAAAAA"/>
               </a:ext>
             </a:extLst>
           </p:cNvSpPr>
@@ -9026,7 +9026,7 @@
             <a:picLocks noChangeAspect="1"/>
             <a:extLst>
               <a:ext uri="smNativeData">
-                <pr:smNativeData xmlns:pr="smNativeData" xmlns="smNativeData" val="SMDATA_17_9kV5ZhMAAAAlAAAAEQAAAC8BAAAAkAAAAEgAAACQAAAASAAAAAAAAAAAAAAAAAAAAAEAAABQAAAAAAAAAAAA4D8AAAAAAADgPwAAAAAAAOA/AAAAAAAA4D8AAAAAAADgPwAAAAAAAOA/AAAAAAAA4D8AAAAAAADgPwAAAAAAAOA/AAAAAAAA4D8CAAAAjAAAAAAAAAAAAAAAQoX0DP///wgAAAAAAAAAAAAAAAAAAAAAAAAAAAAAAAAAAAAAZAAAAAEAAABAAAAAAAAAAAAAAAAAAAAAAAAAAAAAAAAAAAAAAAAAAAAAAAAAAAAAAAAAAAAAAAAAAAAAAAAAAAAAAAAAAAAAAAAAAAAAAAAAAAAAAAAAAAAAAAAAAAAAFAAAADwAAAAAAAAAAAAAAAAAAAkUAAAAAQAAABQAAAAUAAAAFAAAAAEAAAAAAAAAZAAAAGQAAAAAAAAAZAAAAGQAAAAVAAAAYAAAAAAAAAAAAAAADwAAACADAAAAAAAAAAAAAAEAAACgMgAAVgcAAKr4//8BAAAAf39/AAEAAABkAAAAAAAAABQAAABAHwAAAAAAACYAAAAAAAAAwOD//wAAAAAmAAAAZAAAABYAAABMAAAAAAAAAAAAAAAEAAAAAAAAAAEAAABZWVkKAAAAACgAAAAoAAAAZAAAAGQAAAAAAAAAzMzMAAAAAABQAAAAUAAAAGQAAABkAAAAAAAAAAcAAAA4AAAAAAAAAAAAAAAAAAAA////AAAAAAAAAAAAAAAAAAAAAAAAAAAAAAAAAAAAAABkAAAAZAAAAAAAAAAjAAAABAAAAGQAAAAXAAAAFAAAAAAAAAAAAAAA/38AAP9/AAAAAAAACQAAAAQAAAABAAAAHgAAAGgAAAAAAAAAAAAAAAAAAAAAAAAAAAAAABAnAAAQJwAAAAAAAAAAAAAAAAAAAAAAAAAAAAAAAAAAAAAAAAAAAAAUAAAAAAAAAMDA/wAAAAAAZAAAADIAAAAAAAAAZAAAAAAAAAB/f38ACgAAACIAAAAYAAAAAAAAAAAAAAAAAAAAAAAAAAAAAAAAAAAAJAAAACQAAAAAAAAABwAAAAAAAAAAAAAAAAAAAAAAAAAAAAAAAAAAAH9/fwAlAAAAWAAAAAAAAAAAAAAAAAAAAAAAAAAAAAAAAAAAAAAAAAAAAAAAAAAAAAAAAAAAAAAAPwAAAAAAAACghgEAAAAAAAAAAAAAAAAADAAAAAEAAAAAAAAAAAAAAAAAAAAfAAAAVAAAAEKF9AX///8BAAAAAAAAAAAAAAAAAAAAAAAAAAAAAAAAAAAAAAAAAAAAAAACf39/AFlZWQPMzMwAwMD/AH9/fwAAAAAAAAAAAAAAAAD///8AAAAAACEAAAAYAAAAFAAAAOwDAADNDgAA7yIAAA4nAAAQAAAAJgAAAAgAAAD//////////w=="/>
+                <pr:smNativeData xmlns:pr="smNativeData" xmlns="smNativeData" val="SMDATA_17_bQt8ZhMAAAAlAAAAEQAAAC8BAAAAkAAAAEgAAACQAAAASAAAAAAAAAAAAAAAAAAAAAEAAABQAAAAAAAAAAAA4D8AAAAAAADgPwAAAAAAAOA/AAAAAAAA4D8AAAAAAADgPwAAAAAAAOA/AAAAAAAA4D8AAAAAAADgPwAAAAAAAOA/AAAAAAAA4D8CAAAAjAAAAAAAAAAAAAAAQoX0DP///wgAAAAAAAAAAAAAAAAAAAAAAAAAAAAAAAAAAAAAZAAAAAEAAABAAAAAAAAAAAAAAAAAAAAAAAAAAAAAAAAAAAAAAAAAAAAAAAAAAAAAAAAAAAAAAAAAAAAAAAAAAAAAAAAAAAAAAAAAAAAAAAAAAAAAAAAAAAAAAAAAAAAAFAAAADwAAAAAAAAAAAAAAAAAAAkUAAAAAQAAABQAAAAUAAAAFAAAAAEAAAAAAAAAZAAAAGQAAAAAAAAAZAAAAGQAAAAVAAAAYAAAAAAAAAAAAAAADwAAACADAAAAAAAAAAAAAAEAAACgMgAAVgcAAKr4//8BAAAAf39/AAEAAABkAAAAAAAAABQAAABAHwAAAAAAACYAAAAAAAAAwOD//wAAAAAmAAAAZAAAABYAAABMAAAAAAAAAAAAAAAEAAAAAAAAAAEAAABZWVkKAAAAACgAAAAoAAAAZAAAAGQAAAAAAAAAzMzMAAAAAABQAAAAUAAAAGQAAABkAAAAAAAAAAcAAAA4AAAAAAAAAAAAAAAAAAAA////AAAAAAAAAAAAAAAAAAAAAAAAAAAAAAAAAAAAAABkAAAAZAAAAAAAAAAjAAAABAAAAGQAAAAXAAAAFAAAAAAAAAAAAAAA/38AAP9/AAAAAAAACQAAAAQAAAABAAAAHgAAAGgAAAAAAAAAAAAAAAAAAAAAAAAAAAAAABAnAAAQJwAAAAAAAAAAAAAAAAAAAAAAAAAAAAAAAAAAAAAAAAAAAAAUAAAAAAAAAMDA/wAAAAAAZAAAADIAAAAAAAAAZAAAAAAAAAB/f38ACgAAACIAAAAYAAAAAAAAAAAAAAAAAAAAAAAAAAAAAAAAAAAAJAAAACQAAAAAAAAABwAAAAAAAAAAAAAAAAAAAAAAAAAAAAAAAAAAAH9/fwAlAAAAWAAAAAAAAAAAAAAAAAAAAAAAAAAAAAAAAAAAAAAAAAAAAAAAAAAAAAAAAAAAAAAAPwAAAAAAAACghgEAAAAAAAAAAAAAAAAADAAAAAEAAAAAAAAAAAAAAAAAAAAfAAAAVAAAAEKF9AX///8BAAAAAAAAAAAAAAAAAAAAAAAAAAAAAAAAAAAAAAAAAAAAAAACf39/AFlZWQPMzMwAwMD/AH9/fwAAAAAAAAAAAAAAAAD///8AAAAAACEAAAAYAAAAFAAAAOwDAADNDgAA7yIAAA4nAAAQAAAAJgAAAAgAAAD//////////w=="/>
               </a:ext>
             </a:extLst>
           </p:cNvPicPr>
@@ -9092,7 +9092,7 @@
             <a:spLocks noGrp="1" noChangeArrowheads="1"/>
             <a:extLst>
               <a:ext uri="smNativeData">
-                <pr:smNativeData xmlns:pr="smNativeData" xmlns="smNativeData" val="SMDATA_15_9kV5ZhMAAAAlAAAAZAAAAA0AAAAAkAAAAJAAAACQAAAAkAAAAAAAAAAAAAAAAAAAAAEAAABQAAAAAAAAAAAA4D8AAAAAAADgPwAAAAAAAOA/AAAAAAAA4D8AAAAAAADgPwAAAAAAAOA/AAAAAAAA4D8AAAAAAADgPwAAAAAAAOA/AAAAAAAA4D8CAAAAjAAAAAAAAAAAAAAAQoX0DP///wgAAAAAAAAAAAAAAAAAAAAAAAAAAAAAAAAAAAAAZAAAAAEAAABAAAAAAAAAAAAAAAAAAAAAAAAAAAAAAAAAAAAAAAAAAAAAAAAAAAAAAAAAAAAAAAAAAAAAAAAAAAAAAAAAAAAAAAAAAAAAAAAAAAAAAAAAAAAAAAAAAAAAFAAAADwAAAAAAAAAAAAAAAAAAAkUAAAAAQAAABQAAAAUAAAAFAAAAAEAAAAAAAAAZAAAAGQAAAAAAAAAZAAAAGQAAAAVAAAAYAAAAAAAAAAAAAAADwAAACADAAAAAAAAAAAAAAEAAACgMgAAVgcAAKr4//8BAAAAf39/AAEAAABkAAAAAAAAABQAAABAHwAAAAAAACYAAAAAAAAAwOD//wAAAAAmAAAAZAAAABYAAABMAAAAAAAAAAAAAAAEAAAAAAAAAAEAAABZWVkKAAAAACgAAAAoAAAAZAAAAGQAAAAAAAAAzMzMAAAAAABQAAAAUAAAAGQAAABkAAAAAAAAABcAAAAUAAAAAAAAAAAAAAD/fwAA/38AAAAAAAAJAAAABAAAAAAAAAAeAAAAaAAAAAAAAAAAAAAAAAAAAAAAAAAAAAAAECcAABAnAAAAAAAAAAAAAAAAAAAAAAAAAAAAAAAAAAAAAAAAAAAAABQAAAAAAAAAwMD/AAAAAABkAAAAMgAAAAAAAABkAAAAAAAAAH9/fwAKAAAAIgAAABgAAAAAAAAAAAAAAAAAAAAAAAAAAAAAAAAAAAAkAAAAJAAAAAAAAAAHAAAAAAAAAAAAAAAAAAAAAAAAAAAAAAAAAAAAf39/ACUAAABYAAAAAAAAAAAAAAAAAAAAAAAAAAAAAAAAAAAAAAAAAAAAAAAAAAAAAAAAAAAAAAA/AAAAAAAAAKCGAQAAAAAAAAAAAAAAAAAMAAAAAQAAAAAAAAAAAAAAAAAAAB8AAABUAAAAAAAABQAAAAEAAAAAAAAAAAAAAAAAAAAAAAAAAAAAAAAAAAAAAAAAAAAAAAJ/f38AWVlZA8zMzADAwP8Af39/AAAAAAAAAAAAAAAAAAAAAAAAAAAAIQAAABgAAAAUAAAAFAMAALYCAAB/NwAAvwoAABAAAAAmAAAACAAAAAAAAAAAAAAA"/>
+                <pr:smNativeData xmlns:pr="smNativeData" xmlns="smNativeData" val="SMDATA_15_bQt8ZhMAAAAlAAAAZAAAAA0AAAAAkAAAAJAAAACQAAAAkAAAAAAAAAAAAAAAAAAAAAEAAABQAAAAAAAAAAAA4D8AAAAAAADgPwAAAAAAAOA/AAAAAAAA4D8AAAAAAADgPwAAAAAAAOA/AAAAAAAA4D8AAAAAAADgPwAAAAAAAOA/AAAAAAAA4D8CAAAAjAAAAAAAAAAAAAAAQoX0DP///wgAAAAAAAAAAAAAAAAAAAAAAAAAAAAAAAAAAAAAZAAAAAEAAABAAAAAAAAAAAAAAAAAAAAAAAAAAAAAAAAAAAAAAAAAAAAAAAAAAAAAAAAAAAAAAAAAAAAAAAAAAAAAAAAAAAAAAAAAAAAAAAAAAAAAAAAAAAAAAAAAAAAAFAAAADwAAAAAAAAAAAAAAAAAAAkUAAAAAQAAABQAAAAUAAAAFAAAAAEAAAAAAAAAZAAAAGQAAAAAAAAAZAAAAGQAAAAVAAAAYAAAAAAAAAAAAAAADwAAACADAAAAAAAAAAAAAAEAAACgMgAAVgcAAKr4//8BAAAAf39/AAEAAABkAAAAAAAAABQAAABAHwAAAAAAACYAAAAAAAAAwOD//wAAAAAmAAAAZAAAABYAAABMAAAAAAAAAAAAAAAEAAAAAAAAAAEAAABZWVkKAAAAACgAAAAoAAAAZAAAAGQAAAAAAAAAzMzMAAAAAABQAAAAUAAAAGQAAABkAAAAAAAAABcAAAAUAAAAAAAAAAAAAAD/fwAA/38AAAAAAAAJAAAABAAAAAAAAAAeAAAAaAAAAAAAAAAAAAAAAAAAAAAAAAAAAAAAECcAABAnAAAAAAAAAAAAAAAAAAAAAAAAAAAAAAAAAAAAAAAAAAAAABQAAAAAAAAAwMD/AAAAAABkAAAAMgAAAAAAAABkAAAAAAAAAH9/fwAKAAAAIgAAABgAAAAAAAAAAAAAAAAAAAAAAAAAAAAAAAAAAAAkAAAAJAAAAAAAAAAHAAAAAAAAAAAAAAAAAAAAAAAAAAAAAAAAAAAAf39/ACUAAABYAAAAAAAAAAAAAAAAAAAAAAAAAAAAAAAAAAAAAAAAAAAAAAAAAAAAAAAAAAAAAAA/AAAAAAAAAKCGAQAAAAAAAAAAAAAAAAAMAAAAAQAAAAAAAAAAAAAAAAAAAB8AAABUAAAAQoX0Bf///wEAAAAAAAAAAAAAAAAAAAAAAAAAAAAAAAAAAAAAAAAAAAAAAAJ/f38AWVlZA8zMzADAwP8Af39/AAAAAAAAAAAAAAAAAAAAAAAAAAAAIQAAABgAAAAUAAAAFAMAALYCAAB/NwAAvwoAABAAAAAmAAAACAAAAAAAAAAAAAAA"/>
               </a:ext>
             </a:extLst>
           </p:cNvSpPr>
@@ -9119,7 +9119,7 @@
             <a:spLocks noGrp="1" noChangeArrowheads="1"/>
             <a:extLst>
               <a:ext uri="smNativeData">
-                <pr:smNativeData xmlns:pr="smNativeData" xmlns="smNativeData" val="SMDATA_15_9kV5ZhMAAAAlAAAAZAAAAA0AAAAAkAAAAJAAAACQAAAAkAAAAAAAAAAAAAAAAAAAAAEAAABQAAAAAAAAAAAA4D8AAAAAAADgPwAAAAAAAOA/AAAAAAAA4D8AAAAAAADgPwAAAAAAAOA/AAAAAAAA4D8AAAAAAADgPwAAAAAAAOA/AAAAAAAA4D8CAAAAjAAAAAAAAAAAAAAAQoX0DP///wgAAAAAAAAAAAAAAAAAAAAAAAAAAAAAAAAAAAAAZAAAAAEAAABAAAAAAAAAAAAAAAAAAAAAAAAAAAAAAAAAAAAAAAAAAAAAAAAAAAAAAAAAAAAAAAAAAAAAAAAAAAAAAAAAAAAAAAAAAAAAAAAAAAAAAAAAAAAAAAAAAAAAFAAAADwAAAAAAAAAAAAAAAAAAAkUAAAAAQAAABQAAAAUAAAAFAAAAAEAAAAAAAAAZAAAAGQAAAAAAAAAZAAAAGQAAAAVAAAAYAAAAAAAAAAAAAAADwAAACADAAAAAAAAAAAAAAEAAACgMgAAVgcAAKr4//8BAAAAf39/AAEAAABkAAAAAAAAABQAAABAHwAAAAAAACYAAAAAAAAAwOD//wAAAAAmAAAAZAAAABYAAABMAAAAAAAAAAAAAAAEAAAAAAAAAAEAAABZWVkKAAAAACgAAAAoAAAAZAAAAGQAAAAAAAAAzMzMAAAAAABQAAAAUAAAAGQAAABkAAAAAAAAABcAAAAUAAAAAAAAAAAAAAD/fwAA/38AAAAAAAAJAAAABAAAAAAAAAAeAAAAaAAAAAAAAAAAAAAAAAAAAAAAAAAAAAAAECcAABAnAAAAAAAAAAAAAAAAAAAAAAAAAAAAAAAAAAAAAAAAAAAAABQAAAAAAAAAwMD/AAAAAABkAAAAMgAAAAAAAABkAAAAAAAAAH9/fwAKAAAAIgAAABgAAAAAAAAAAAAAAAAAAAAAAAAAAAAAAAAAAAAkAAAAJAAAAAAAAAAHAAAAAAAAAAAAAAAAAAAAAAAAAAAAAAAAAAAAf39/ACUAAABYAAAAAAAAAAAAAAAAAAAAAAAAAAAAAAAAAAAAAAAAAAAAAAAAAAAAAAAAAAAAAAA/AAAAAAAAAKCGAQAAAAAAAAAAAAAAAAAMAAAAAQAAAAAAAAAAAAAAAAAAAB8AAABUAAAAAAAABQAAAAEAAAAAAAAAAAAAAAAAAAAAAAAAAAAAAAAAAAAAAAAAAAAAAAJ/f38AWVlZA8zMzADAwP8Af39/AAAAAAAAAAAAAAAAAAAAAAAAAAAAIQAAABgAAAAUAAAAFAMAALMLAAB/NwAAuScAABAAAAAmAAAACAAAAAAAAAAAAAAA"/>
+                <pr:smNativeData xmlns:pr="smNativeData" xmlns="smNativeData" val="SMDATA_15_bQt8ZhMAAAAlAAAAZAAAAA0AAAAAkAAAAJAAAACQAAAAkAAAAAAAAAAAAAAAAAAAAAEAAABQAAAAAAAAAAAA4D8AAAAAAADgPwAAAAAAAOA/AAAAAAAA4D8AAAAAAADgPwAAAAAAAOA/AAAAAAAA4D8AAAAAAADgPwAAAAAAAOA/AAAAAAAA4D8CAAAAjAAAAAAAAAAAAAAAQoX0DP///wgAAAAAAAAAAAAAAAAAAAAAAAAAAAAAAAAAAAAAZAAAAAEAAABAAAAAAAAAAAAAAAAAAAAAAAAAAAAAAAAAAAAAAAAAAAAAAAAAAAAAAAAAAAAAAAAAAAAAAAAAAAAAAAAAAAAAAAAAAAAAAAAAAAAAAAAAAAAAAAAAAAAAFAAAADwAAAAAAAAAAAAAAAAAAAkUAAAAAQAAABQAAAAUAAAAFAAAAAEAAAAAAAAAZAAAAGQAAAAAAAAAZAAAAGQAAAAVAAAAYAAAAAAAAAAAAAAADwAAACADAAAAAAAAAAAAAAEAAACgMgAAVgcAAKr4//8BAAAAf39/AAEAAABkAAAAAAAAABQAAABAHwAAAAAAACYAAAAAAAAAwOD//wAAAAAmAAAAZAAAABYAAABMAAAAAAAAAAAAAAAEAAAAAAAAAAEAAABZWVkKAAAAACgAAAAoAAAAZAAAAGQAAAAAAAAAzMzMAAAAAABQAAAAUAAAAGQAAABkAAAAAAAAABcAAAAUAAAAAAAAAAAAAAD/fwAA/38AAAAAAAAJAAAABAAAAAAAAAAeAAAAaAAAAAAAAAAAAAAAAAAAAAAAAAAAAAAAECcAABAnAAAAAAAAAAAAAAAAAAAAAAAAAAAAAAAAAAAAAAAAAAAAABQAAAAAAAAAwMD/AAAAAABkAAAAMgAAAAAAAABkAAAAAAAAAH9/fwAKAAAAIgAAABgAAAAAAAAAAAAAAAAAAAAAAAAAAAAAAAAAAAAkAAAAJAAAAAAAAAAHAAAAAAAAAAAAAAAAAAAAAAAAAAAAAAAAAAAAf39/ACUAAABYAAAAAAAAAAAAAAAAAAAAAAAAAAAAAAAAAAAAAAAAAAAAAAAAAAAAAAAAAAAAAAA/AAAAAAAAAKCGAQAAAAAAAAAAAAAAAAAMAAAAAQAAAAAAAAAAAAAAAAAAAB8AAABUAAAAQoX0Bf///wEAAAAAAAAAAAAAAAAAAAAAAAAAAAAAAAAAAAAAAAAAAAAAAAJ/f38AWVlZA8zMzADAwP8Af39/AAAAAAAAAAAAAAAAAAAAAAAAAAAAIQAAABgAAAAUAAAAFAMAALMLAAB/NwAAuScAABAAAAAmAAAACAAAAAAAAAAAAAAA"/>
               </a:ext>
             </a:extLst>
           </p:cNvSpPr>
@@ -9152,7 +9152,7 @@
             <a:picLocks noChangeAspect="1"/>
             <a:extLst>
               <a:ext uri="smNativeData">
-                <pr:smNativeData xmlns:pr="smNativeData" xmlns="smNativeData" val="SMDATA_17_9kV5ZhMAAAAlAAAAEQAAAC8BAAAAkAAAAEgAAACQAAAASAAAAAAAAAAAAAAAAAAAAAEAAABQAAAAAAAAAAAA4D8AAAAAAADgPwAAAAAAAOA/AAAAAAAA4D8AAAAAAADgPwAAAAAAAOA/AAAAAAAA4D8AAAAAAADgPwAAAAAAAOA/AAAAAAAA4D8CAAAAjAAAAAAAAAAAAAAAQoX0DP///wgAAAAAAAAAAAAAAAAAAAAAAAAAAAAAAAAAAAAAZAAAAAEAAABAAAAAAAAAAAAAAAAAAAAAAAAAAAAAAAAAAAAAAAAAAAAAAAAAAAAAAAAAAAAAAAAAAAAAAAAAAAAAAAAAAAAAAAAAAAAAAAAAAAAAAAAAAAAAAAAAAAAAFAAAADwAAAAAAAAAAAAAAAAAAAkUAAAAAQAAABQAAAAUAAAAFAAAAAEAAAAAAAAAZAAAAGQAAAAAAAAAZAAAAGQAAAAVAAAAYAAAAAAAAAAAAAAADwAAACADAAAAAAAAAAAAAAEAAACgMgAAVgcAAKr4//8BAAAAf39/AAEAAABkAAAAAAAAABQAAABAHwAAAAAAACYAAAAAAAAAwOD//wAAAAAmAAAAZAAAABYAAABMAAAAAAAAAAAAAAAEAAAAAAAAAAEAAABZWVkKAAAAACgAAAAoAAAAZAAAAGQAAAAAAAAAzMzMAAAAAABQAAAAUAAAAGQAAABkAAAAAAAAAAcAAAA4AAAAAAAAAAAAAAAAAAAA////AAAAAAAAAAAAAAAAAAAAAAAAAAAAAAAAAAAAAABkAAAAZAAAAAAAAAAjAAAABAAAAGQAAAAXAAAAFAAAAAAAAAAAAAAA/38AAP9/AAAAAAAACQAAAAQAAAAAAAAAHgAAAGgAAAAAAAAAAAAAAAAAAAAAAAAAAAAAABAnAAAQJwAAAAAAAAAAAAAAAAAAAAAAAAAAAAAAAAAAAAAAAAAAAAAUAAAAAAAAAMDA/wAAAAAAZAAAADIAAAAAAAAAZAAAAAAAAAB/f38ACgAAACIAAAAYAAAAAAAAAAAAAAAAAAAAAAAAAAAAAAAAAAAAJAAAACQAAAAAAAAABwAAAAAAAAAAAAAAAAAAAAAAAAAAAAAAAAAAAH9/fwAlAAAAWAAAAAAAAAAAAAAAAAAAAAAAAAAAAAAAAAAAAAAAAAAAAAAAAAAAAAAAAAAAAAAAPwAAAAAAAACghgEAAAAAAAAAAAAAAAAADAAAAAEAAAAAAAAAAAAAAAAAAAAfAAAAVAAAAEKF9AX///8BAAAAAAAAAAAAAAAAAAAAAAAAAAAAAAAAAAAAAAAAAAAAAAACf39/AFlZWQPMzMwAwMD/AH9/fwAAAAAAAAAAAAAAAAD///8AAAAAACEAAAAYAAAAFAAAACEEAADlDgAAuS8AAKMkAAAQAAAAJgAAAAgAAAD//////////w=="/>
+                <pr:smNativeData xmlns:pr="smNativeData" xmlns="smNativeData" val="SMDATA_17_bQt8ZhMAAAAlAAAAEQAAAC8BAAAAkAAAAEgAAACQAAAASAAAAAAAAAAAAAAAAAAAAAEAAABQAAAAAAAAAAAA4D8AAAAAAADgPwAAAAAAAOA/AAAAAAAA4D8AAAAAAADgPwAAAAAAAOA/AAAAAAAA4D8AAAAAAADgPwAAAAAAAOA/AAAAAAAA4D8CAAAAjAAAAAAAAAAAAAAAQoX0DP///wgAAAAAAAAAAAAAAAAAAAAAAAAAAAAAAAAAAAAAZAAAAAEAAABAAAAAAAAAAAAAAAAAAAAAAAAAAAAAAAAAAAAAAAAAAAAAAAAAAAAAAAAAAAAAAAAAAAAAAAAAAAAAAAAAAAAAAAAAAAAAAAAAAAAAAAAAAAAAAAAAAAAAFAAAADwAAAAAAAAAAAAAAAAAAAkUAAAAAQAAABQAAAAUAAAAFAAAAAEAAAAAAAAAZAAAAGQAAAAAAAAAZAAAAGQAAAAVAAAAYAAAAAAAAAAAAAAADwAAACADAAAAAAAAAAAAAAEAAACgMgAAVgcAAKr4//8BAAAAf39/AAEAAABkAAAAAAAAABQAAABAHwAAAAAAACYAAAAAAAAAwOD//wAAAAAmAAAAZAAAABYAAABMAAAAAAAAAAAAAAAEAAAAAAAAAAEAAABZWVkKAAAAACgAAAAoAAAAZAAAAGQAAAAAAAAAzMzMAAAAAABQAAAAUAAAAGQAAABkAAAAAAAAAAcAAAA4AAAAAAAAAAAAAAAAAAAA////AAAAAAAAAAAAAAAAAAAAAAAAAAAAAAAAAAAAAABkAAAAZAAAAAAAAAAjAAAABAAAAGQAAAAXAAAAFAAAAAAAAAAAAAAA/38AAP9/AAAAAAAACQAAAAQAAAAAAAAAHgAAAGgAAAAAAAAAAAAAAAAAAAAAAAAAAAAAABAnAAAQJwAAAAAAAAAAAAAAAAAAAAAAAAAAAAAAAAAAAAAAAAAAAAAUAAAAAAAAAMDA/wAAAAAAZAAAADIAAAAAAAAAZAAAAAAAAAB/f38ACgAAACIAAAAYAAAAAAAAAAAAAAAAAAAAAAAAAAAAAAAAAAAAJAAAACQAAAAAAAAABwAAAAAAAAAAAAAAAAAAAAAAAAAAAAAAAAAAAH9/fwAlAAAAWAAAAAAAAAAAAAAAAAAAAAAAAAAAAAAAAAAAAAAAAAAAAAAAAAAAAAAAAAAAAAAAPwAAAAAAAACghgEAAAAAAAAAAAAAAAAADAAAAAEAAAAAAAAAAAAAAAAAAAAfAAAAVAAAAEKF9AX///8BAAAAAAAAAAAAAAAAAAAAAAAAAAAAAAAAAAAAAAAAAAAAAAACf39/AFlZWQPMzMwAwMD/AH9/fwAAAAAAAAAAAAAAAAD///8AAAAAACEAAAAYAAAAFAAAACEEAADlDgAAuS8AAKMkAAAQAAAAJgAAAAgAAAD//////////w=="/>
               </a:ext>
             </a:extLst>
           </p:cNvPicPr>
@@ -9218,7 +9218,7 @@
             <a:spLocks noGrp="1" noChangeArrowheads="1"/>
             <a:extLst>
               <a:ext uri="smNativeData">
-                <pr:smNativeData xmlns:pr="smNativeData" xmlns="smNativeData" val="SMDATA_15_9kV5ZhMAAAAlAAAAZAAAAA0AAAAAkAAAAJAAAACQAAAAkAAAAAAAAAAAAAAAAAAAAAEAAABQAAAAAAAAAAAA4D8AAAAAAADgPwAAAAAAAOA/AAAAAAAA4D8AAAAAAADgPwAAAAAAAOA/AAAAAAAA4D8AAAAAAADgPwAAAAAAAOA/AAAAAAAA4D8CAAAAjAAAAAAAAAAAAAAAQoX0DP///wgAAAAAAAAAAAAAAAAAAAAAAAAAAAAAAAAAAAAAZAAAAAEAAABAAAAAAAAAAAAAAAAAAAAAAAAAAAAAAAAAAAAAAAAAAAAAAAAAAAAAAAAAAAAAAAAAAAAAAAAAAAAAAAAAAAAAAAAAAAAAAAAAAAAAAAAAAAAAAAAAAAAAFAAAADwAAAAAAAAAAAAAAAAAAAkUAAAAAQAAABQAAAAUAAAAFAAAAAEAAAAAAAAAZAAAAGQAAAAAAAAAZAAAAGQAAAAVAAAAYAAAAAAAAAAAAAAADwAAACADAAAAAAAAAAAAAAEAAACgMgAAVgcAAKr4//8BAAAAf39/AAEAAABkAAAAAAAAABQAAABAHwAAAAAAACYAAAAAAAAAwOD//wAAAAAmAAAAZAAAABYAAABMAAAAAAAAAAAAAAAEAAAAAAAAAAEAAABZWVkKAAAAACgAAAAoAAAAZAAAAGQAAAAAAAAAzMzMAAAAAABQAAAAUAAAAGQAAABkAAAAAAAAABcAAAAUAAAAAAAAAAAAAAD/fwAA/38AAAAAAAAJAAAABAAAAAAAAAAeAAAAaAAAAAAAAAAAAAAAAAAAAAAAAAAAAAAAECcAABAnAAAAAAAAAAAAAAAAAAAAAAAAAAAAAAAAAAAAAAAAAAAAABQAAAAAAAAAwMD/AAAAAABkAAAAMgAAAAAAAABkAAAAAAAAAH9/fwAKAAAAIgAAABgAAAAAAAAAAAAAAAAAAAAAAAAAAAAAAAAAAAAkAAAAJAAAAAAAAAAHAAAAAAAAAAAAAAAAAAAAAAAAAAAAAAAAAAAAf39/ACUAAABYAAAAAAAAAAAAAAAAAAAAAAAAAAAAAAAAAAAAAAAAAAAAAAAAAAAAAAAAAAAAAAA/AAAAAAAAAKCGAQAAAAAAAAAAAAAAAAAMAAAAAQAAAAAAAAAAAAAAAAAAAB8AAABUAAAAQoX0Bf///wEAAAAAAAAAAAAAAAAAAAAAAAAAAAAAAAAAAAAAAAAAAAAAAAJ/f38AWVlZA8zMzADAwP8Af39/AAAAAAAAAAAAAAAAAAAAAAAAAAAAIQAAABgAAAAUAAAAFAMAALYCAAB/NwAAvwoAABAAAAAmAAAACAAAAAAAAAAAAAAA"/>
+                <pr:smNativeData xmlns:pr="smNativeData" xmlns="smNativeData" val="SMDATA_15_bQt8ZhMAAAAlAAAAZAAAAA0AAAAAkAAAAJAAAACQAAAAkAAAAAAAAAAAAAAAAAAAAAEAAABQAAAAAAAAAAAA4D8AAAAAAADgPwAAAAAAAOA/AAAAAAAA4D8AAAAAAADgPwAAAAAAAOA/AAAAAAAA4D8AAAAAAADgPwAAAAAAAOA/AAAAAAAA4D8CAAAAjAAAAAAAAAAAAAAAQoX0DP///wgAAAAAAAAAAAAAAAAAAAAAAAAAAAAAAAAAAAAAZAAAAAEAAABAAAAAAAAAAAAAAAAAAAAAAAAAAAAAAAAAAAAAAAAAAAAAAAAAAAAAAAAAAAAAAAAAAAAAAAAAAAAAAAAAAAAAAAAAAAAAAAAAAAAAAAAAAAAAAAAAAAAAFAAAADwAAAAAAAAAAAAAAAAAAAkUAAAAAQAAABQAAAAUAAAAFAAAAAEAAAAAAAAAZAAAAGQAAAAAAAAAZAAAAGQAAAAVAAAAYAAAAAAAAAAAAAAADwAAACADAAAAAAAAAAAAAAEAAACgMgAAVgcAAKr4//8BAAAAf39/AAEAAABkAAAAAAAAABQAAABAHwAAAAAAACYAAAAAAAAAwOD//wAAAAAmAAAAZAAAABYAAABMAAAAAAAAAAAAAAAEAAAAAAAAAAEAAABZWVkKAAAAACgAAAAoAAAAZAAAAGQAAAAAAAAAzMzMAAAAAABQAAAAUAAAAGQAAABkAAAAAAAAABcAAAAUAAAAAAAAAAAAAAD/fwAA/38AAAAAAAAJAAAABAAAAAAAAAAeAAAAaAAAAAAAAAAAAAAAAAAAAAAAAAAAAAAAECcAABAnAAAAAAAAAAAAAAAAAAAAAAAAAAAAAAAAAAAAAAAAAAAAABQAAAAAAAAAwMD/AAAAAABkAAAAMgAAAAAAAABkAAAAAAAAAH9/fwAKAAAAIgAAABgAAAAAAAAAAAAAAAAAAAAAAAAAAAAAAAAAAAAkAAAAJAAAAAAAAAAHAAAAAAAAAAAAAAAAAAAAAAAAAAAAAAAAAAAAf39/ACUAAABYAAAAAAAAAAAAAAAAAAAAAAAAAAAAAAAAAAAAAAAAAAAAAAAAAAAAAAAAAAAAAAA/AAAAAAAAAKCGAQAAAAAAAAAAAAAAAAAMAAAAAQAAAAAAAAAAAAAAAAAAAB8AAABUAAAAQoX0Bf///wEAAAAAAAAAAAAAAAAAAAAAAAAAAAAAAAAAAAAAAAAAAAAAAAJ/f38AWVlZA8zMzADAwP8Af39/AAAAAAAAAAAAAAAAAAAAAAAAAAAAIQAAABgAAAAUAAAAFAMAALYCAAB/NwAAvwoAABAAAAAmAAAACAAAAAAAAAAAAAAA"/>
               </a:ext>
             </a:extLst>
           </p:cNvSpPr>
@@ -9245,7 +9245,7 @@
             <a:spLocks noGrp="1" noChangeArrowheads="1"/>
             <a:extLst>
               <a:ext uri="smNativeData">
-                <pr:smNativeData xmlns:pr="smNativeData" xmlns="smNativeData" val="SMDATA_15_9kV5ZhMAAAAlAAAAZAAAAA0AAAAAkAAAAJAAAACQAAAAkAAAAAAAAAAAAAAAAAAAAAEAAABQAAAAAAAAAAAA4D8AAAAAAADgPwAAAAAAAOA/AAAAAAAA4D8AAAAAAADgPwAAAAAAAOA/AAAAAAAA4D8AAAAAAADgPwAAAAAAAOA/AAAAAAAA4D8CAAAAjAAAAAAAAAAAAAAAQoX0DP///wgAAAAAAAAAAAAAAAAAAAAAAAAAAAAAAAAAAAAAZAAAAAEAAABAAAAAAAAAAAAAAAAAAAAAAAAAAAAAAAAAAAAAAAAAAAAAAAAAAAAAAAAAAAAAAAAAAAAAAAAAAAAAAAAAAAAAAAAAAAAAAAAAAAAAAAAAAAAAAAAAAAAAFAAAADwAAAAAAAAAAAAAAAAAAAkUAAAAAQAAABQAAAAUAAAAFAAAAAEAAAAAAAAAZAAAAGQAAAAAAAAAZAAAAGQAAAAVAAAAYAAAAAAAAAAAAAAADwAAACADAAAAAAAAAAAAAAEAAACgMgAAVgcAAKr4//8BAAAAf39/AAEAAABkAAAAAAAAABQAAABAHwAAAAAAACYAAAAAAAAAwOD//wAAAAAmAAAAZAAAABYAAABMAAAAAAAAAAAAAAAEAAAAAAAAAAEAAABZWVkKAAAAACgAAAAoAAAAZAAAAGQAAAAAAAAAzMzMAAAAAABQAAAAUAAAAGQAAABkAAAAAAAAABcAAAAUAAAAAAAAAAAAAAD/fwAA/38AAAAAAAAJAAAABAAAAAAAAAAeAAAAaAAAAAAAAAAAAAAAAAAAAAAAAAAAAAAAECcAABAnAAAAAAAAAAAAAAAAAAAAAAAAAAAAAAAAAAAAAAAAAAAAABQAAAAAAAAAwMD/AAAAAABkAAAAMgAAAAAAAABkAAAAAAAAAH9/fwAKAAAAIgAAABgAAAAAAAAAAAAAAAAAAAAAAAAAAAAAAAAAAAAkAAAAJAAAAAAAAAAHAAAAAAAAAAAAAAAAAAAAAAAAAAAAAAAAAAAAf39/ACUAAABYAAAAAAAAAAAAAAAAAAAAAAAAAAAAAAAAAAAAAAAAAAAAAAAAAAAAAAAAAAAAAAA/AAAAAAAAAKCGAQAAAAAAAAAAAAAAAAAMAAAAAQAAAAAAAAAAAAAAAAAAAB8AAABUAAAAQoX0Bf///wEAAAAAAAAAAAAAAAAAAAAAAAAAAAAAAAAAAAAAAAAAAAAAAAJ/f38AWVlZA8zMzADAwP8Af39/AAAAAAAAAAAAAAAAAAAAAAAAAAAAIQAAABgAAAAUAAAAFAMAALMLAAB/NwAAuScAABAAAAAmAAAACAAAAAAAAAAAAAAA"/>
+                <pr:smNativeData xmlns:pr="smNativeData" xmlns="smNativeData" val="SMDATA_15_bQt8ZhMAAAAlAAAAZAAAAA0AAAAAkAAAAJAAAACQAAAAkAAAAAAAAAAAAAAAAAAAAAEAAABQAAAAAAAAAAAA4D8AAAAAAADgPwAAAAAAAOA/AAAAAAAA4D8AAAAAAADgPwAAAAAAAOA/AAAAAAAA4D8AAAAAAADgPwAAAAAAAOA/AAAAAAAA4D8CAAAAjAAAAAAAAAAAAAAAQoX0DP///wgAAAAAAAAAAAAAAAAAAAAAAAAAAAAAAAAAAAAAZAAAAAEAAABAAAAAAAAAAAAAAAAAAAAAAAAAAAAAAAAAAAAAAAAAAAAAAAAAAAAAAAAAAAAAAAAAAAAAAAAAAAAAAAAAAAAAAAAAAAAAAAAAAAAAAAAAAAAAAAAAAAAAFAAAADwAAAAAAAAAAAAAAAAAAAkUAAAAAQAAABQAAAAUAAAAFAAAAAEAAAAAAAAAZAAAAGQAAAAAAAAAZAAAAGQAAAAVAAAAYAAAAAAAAAAAAAAADwAAACADAAAAAAAAAAAAAAEAAACgMgAAVgcAAKr4//8BAAAAf39/AAEAAABkAAAAAAAAABQAAABAHwAAAAAAACYAAAAAAAAAwOD//wAAAAAmAAAAZAAAABYAAABMAAAAAAAAAAAAAAAEAAAAAAAAAAEAAABZWVkKAAAAACgAAAAoAAAAZAAAAGQAAAAAAAAAzMzMAAAAAABQAAAAUAAAAGQAAABkAAAAAAAAABcAAAAUAAAAAAAAAAAAAAD/fwAA/38AAAAAAAAJAAAABAAAAAAAAAAeAAAAaAAAAAAAAAAAAAAAAAAAAAAAAAAAAAAAECcAABAnAAAAAAAAAAAAAAAAAAAAAAAAAAAAAAAAAAAAAAAAAAAAABQAAAAAAAAAwMD/AAAAAABkAAAAMgAAAAAAAABkAAAAAAAAAH9/fwAKAAAAIgAAABgAAAAAAAAAAAAAAAAAAAAAAAAAAAAAAAAAAAAkAAAAJAAAAAAAAAAHAAAAAAAAAAAAAAAAAAAAAAAAAAAAAAAAAAAAf39/ACUAAABYAAAAAAAAAAAAAAAAAAAAAAAAAAAAAAAAAAAAAAAAAAAAAAAAAAAAAAAAAAAAAAA/AAAAAAAAAKCGAQAAAAAAAAAAAAAAAAAMAAAAAQAAAAAAAAAAAAAAAAAAAB8AAABUAAAAQoX0Bf///wEAAAAAAAAAAAAAAAAAAAAAAAAAAAAAAAAAAAAAAAAAAAAAAAJ/f38AWVlZA8zMzADAwP8Af39/AAAAAAAAAAAAAAAAAAAAAAAAAAAAIQAAABgAAAAUAAAAFAMAALMLAAB/NwAAuScAABAAAAAmAAAACAAAAAAAAAAAAAAA"/>
               </a:ext>
             </a:extLst>
           </p:cNvSpPr>
@@ -9278,7 +9278,7 @@
             <a:picLocks noChangeAspect="1"/>
             <a:extLst>
               <a:ext uri="smNativeData">
-                <pr:smNativeData xmlns:pr="smNativeData" xmlns="smNativeData" val="SMDATA_17_9kV5ZhMAAAAlAAAAEQAAAC8BAAAAkAAAAEgAAACQAAAASAAAAAAAAAAAAAAAAAAAAAEAAABQAAAAAAAAAAAA4D8AAAAAAADgPwAAAAAAAOA/AAAAAAAA4D8AAAAAAADgPwAAAAAAAOA/AAAAAAAA4D8AAAAAAADgPwAAAAAAAOA/AAAAAAAA4D8CAAAAjAAAAAAAAAAAAAAAQoX0DP///wgAAAAAAAAAAAAAAAAAAAAAAAAAAAAAAAAAAAAAZAAAAAEAAABAAAAAAAAAAAAAAAAAAAAAAAAAAAAAAAAAAAAAAAAAAAAAAAAAAAAAAAAAAAAAAAAAAAAAAAAAAAAAAAAAAAAAAAAAAAAAAAAAAAAAAAAAAAAAAAAAAAAAFAAAADwAAAAAAAAAAAAAAAAAAAkUAAAAAQAAABQAAAAUAAAAFAAAAAEAAAAAAAAAZAAAAGQAAAAAAAAAZAAAAGQAAAAVAAAAYAAAAAAAAAAAAAAADwAAACADAAAAAAAAAAAAAAEAAACgMgAAVgcAAKr4//8BAAAAf39/AAEAAABkAAAAAAAAABQAAABAHwAAAAAAACYAAAAAAAAAwOD//wAAAAAmAAAAZAAAABYAAABMAAAAAAAAAAAAAAAEAAAAAAAAAAEAAABZWVkKAAAAACgAAAAoAAAAZAAAAGQAAAAAAAAAzMzMAAAAAABQAAAAUAAAAGQAAABkAAAAAAAAAAcAAAA4AAAAAAAAAAAAAAAAAAAA////AAAAAAAAAAAAAAAAAAAAAAAAAAAAAAAAAAAAAABkAAAAZAAAAAAAAAAjAAAABAAAAGQAAAAXAAAAFAAAAAAAAAAAAAAA/38AAP9/AAAAAAAACQAAAAQAAAAAAAAAHgAAAGgAAAAAAAAAAAAAAAAAAAAAAAAAAAAAABAnAAAQJwAAAAAAAAAAAAAAAAAAAAAAAAAAAAAAAAAAAAAAAAAAAAAUAAAAAAAAAMDA/wAAAAAAZAAAADIAAAAAAAAAZAAAAAAAAAB/f38ACgAAACIAAAAYAAAAAAAAAAAAAAAAAAAAAAAAAAAAAAAAAAAAJAAAACQAAAAAAAAABwAAAAAAAAAAAAAAAAAAAAAAAAAAAAAAAAAAAH9/fwAlAAAAWAAAAAAAAAAAAAAAAAAAAAAAAAAAAAAAAAAAAAAAAAAAAAAAAAAAAAAAAAAAAAAAPwAAAAAAAACghgEAAAAAAAAAAAAAAAAADAAAAAEAAAAAAAAAAAAAAAAAAAAfAAAAVAAAAEKF9AX///8BAAAAAAAAAAAAAAAAAAAAAAAAAAAAAAAAAAAAAAAAAAAAAAACf39/AFlZWQPMzMwAwMD/AH9/fwAAAAAAAAAAAAAAAAD///8AAAAAACEAAAAYAAAAFAAAAKADAACZDgAAIiMAAKUnAAAQAAAAJgAAAAgAAAD//////////w=="/>
+                <pr:smNativeData xmlns:pr="smNativeData" xmlns="smNativeData" val="SMDATA_17_bQt8ZhMAAAAlAAAAEQAAAC8BAAAAkAAAAEgAAACQAAAASAAAAAAAAAAAAAAAAAAAAAEAAABQAAAAAAAAAAAA4D8AAAAAAADgPwAAAAAAAOA/AAAAAAAA4D8AAAAAAADgPwAAAAAAAOA/AAAAAAAA4D8AAAAAAADgPwAAAAAAAOA/AAAAAAAA4D8CAAAAjAAAAAAAAAAAAAAAQoX0DP///wgAAAAAAAAAAAAAAAAAAAAAAAAAAAAAAAAAAAAAZAAAAAEAAABAAAAAAAAAAAAAAAAAAAAAAAAAAAAAAAAAAAAAAAAAAAAAAAAAAAAAAAAAAAAAAAAAAAAAAAAAAAAAAAAAAAAAAAAAAAAAAAAAAAAAAAAAAAAAAAAAAAAAFAAAADwAAAAAAAAAAAAAAAAAAAkUAAAAAQAAABQAAAAUAAAAFAAAAAEAAAAAAAAAZAAAAGQAAAAAAAAAZAAAAGQAAAAVAAAAYAAAAAAAAAAAAAAADwAAACADAAAAAAAAAAAAAAEAAACgMgAAVgcAAKr4//8BAAAAf39/AAEAAABkAAAAAAAAABQAAABAHwAAAAAAACYAAAAAAAAAwOD//wAAAAAmAAAAZAAAABYAAABMAAAAAAAAAAAAAAAEAAAAAAAAAAEAAABZWVkKAAAAACgAAAAoAAAAZAAAAGQAAAAAAAAAzMzMAAAAAABQAAAAUAAAAGQAAABkAAAAAAAAAAcAAAA4AAAAAAAAAAAAAAAAAAAA////AAAAAAAAAAAAAAAAAAAAAAAAAAAAAAAAAAAAAABkAAAAZAAAAAAAAAAjAAAABAAAAGQAAAAXAAAAFAAAAAAAAAAAAAAA/38AAP9/AAAAAAAACQAAAAQAAAAAAAAAHgAAAGgAAAAAAAAAAAAAAAAAAAAAAAAAAAAAABAnAAAQJwAAAAAAAAAAAAAAAAAAAAAAAAAAAAAAAAAAAAAAAAAAAAAUAAAAAAAAAMDA/wAAAAAAZAAAADIAAAAAAAAAZAAAAAAAAAB/f38ACgAAACIAAAAYAAAAAAAAAAAAAAAAAAAAAAAAAAAAAAAAAAAAJAAAACQAAAAAAAAABwAAAAAAAAAAAAAAAAAAAAAAAAAAAAAAAAAAAH9/fwAlAAAAWAAAAAAAAAAAAAAAAAAAAAAAAAAAAAAAAAAAAAAAAAAAAAAAAAAAAAAAAAAAAAAAPwAAAAAAAACghgEAAAAAAAAAAAAAAAAADAAAAAEAAAAAAAAAAAAAAAAAAAAfAAAAVAAAAEKF9AX///8BAAAAAAAAAAAAAAAAAAAAAAAAAAAAAAAAAAAAAAAAAAAAAAACf39/AFlZWQPMzMwAwMD/AH9/fwAAAAAAAAAAAAAAAAD///8AAAAAACEAAAAYAAAAFAAAAKADAACZDgAAIiMAAKUnAAAQAAAAJgAAAAgAAAD//////////w=="/>
               </a:ext>
             </a:extLst>
           </p:cNvPicPr>
@@ -9344,7 +9344,7 @@
             <a:spLocks noGrp="1" noChangeArrowheads="1"/>
             <a:extLst>
               <a:ext uri="smNativeData">
-                <pr:smNativeData xmlns:pr="smNativeData" xmlns="smNativeData" val="SMDATA_15_9kV5ZhMAAAAlAAAAZAAAAA0AAAAAkAAAAJAAAACQAAAAkAAAAAAAAAAAAAAAAAAAAAEAAABQAAAAAAAAAAAA4D8AAAAAAADgPwAAAAAAAOA/AAAAAAAA4D8AAAAAAADgPwAAAAAAAOA/AAAAAAAA4D8AAAAAAADgPwAAAAAAAOA/AAAAAAAA4D8CAAAAjAAAAAAAAAAAAAAAQoX0DP///wgAAAAAAAAAAAAAAAAAAAAAAAAAAAAAAAAAAAAAZAAAAAEAAABAAAAAAAAAAAAAAAAAAAAAAAAAAAAAAAAAAAAAAAAAAAAAAAAAAAAAAAAAAAAAAAAAAAAAAAAAAAAAAAAAAAAAAAAAAAAAAAAAAAAAAAAAAAAAAAAAAAAAFAAAADwAAAAAAAAAAAAAAAAAAAkUAAAAAQAAABQAAAAUAAAAFAAAAAEAAAAAAAAAZAAAAGQAAAAAAAAAZAAAAGQAAAAVAAAAYAAAAAAAAAAAAAAADwAAACADAAAAAAAAAAAAAAEAAACgMgAAVgcAAKr4//8BAAAAf39/AAEAAABkAAAAAAAAABQAAABAHwAAAAAAACYAAAAAAAAAwOD//wAAAAAmAAAAZAAAABYAAABMAAAAAAAAAAAAAAAEAAAAAAAAAAEAAABZWVkKAAAAACgAAAAoAAAAZAAAAGQAAAAAAAAAzMzMAAAAAABQAAAAUAAAAGQAAABkAAAAAAAAABcAAAAUAAAAAAAAAAAAAAD/fwAA/38AAAAAAAAJAAAABAAAAAAAAAAeAAAAaAAAAAAAAAAAAAAAAAAAAAAAAAAAAAAAECcAABAnAAAAAAAAAAAAAAAAAAAAAAAAAAAAAAAAAAAAAAAAAAAAABQAAAAAAAAAwMD/AAAAAABkAAAAMgAAAAAAAABkAAAAAAAAAH9/fwAKAAAAIgAAABgAAAAAAAAAAAAAAAAAAAAAAAAAAAAAAAAAAAAkAAAAJAAAAAAAAAAHAAAAAAAAAAAAAAAAAAAAAAAAAAAAAAAAAAAAf39/ACUAAABYAAAAAAAAAAAAAAAAAAAAAAAAAAAAAAAAAAAAAAAAAAAAAAAAAAAAAAAAAAAAAAA/AAAAAAAAAKCGAQAAAAAAAAAAAAAAAAAMAAAAAQAAAAAAAAAAAAAAAAAAAB8AAABUAAAAQoX0Bf///wEAAAAAAAAAAAAAAAAAAAAAAAAAAAAAAAAAAAAAAAAAAAAAAAJ/f38AWVlZA8zMzADAwP8Af39/AAAAAAAAAAAAAAAAAAAAAAAAAAAAIQAAABgAAAAUAAAAFAMAALYCAAB/NwAAvwoAABAAAAAmAAAACAAAAAAAAAAAAAAA"/>
+                <pr:smNativeData xmlns:pr="smNativeData" xmlns="smNativeData" val="SMDATA_15_bQt8ZhMAAAAlAAAAZAAAAA0AAAAAkAAAAJAAAACQAAAAkAAAAAAAAAAAAAAAAAAAAAEAAABQAAAAAAAAAAAA4D8AAAAAAADgPwAAAAAAAOA/AAAAAAAA4D8AAAAAAADgPwAAAAAAAOA/AAAAAAAA4D8AAAAAAADgPwAAAAAAAOA/AAAAAAAA4D8CAAAAjAAAAAAAAAAAAAAAQoX0DP///wgAAAAAAAAAAAAAAAAAAAAAAAAAAAAAAAAAAAAAZAAAAAEAAABAAAAAAAAAAAAAAAAAAAAAAAAAAAAAAAAAAAAAAAAAAAAAAAAAAAAAAAAAAAAAAAAAAAAAAAAAAAAAAAAAAAAAAAAAAAAAAAAAAAAAAAAAAAAAAAAAAAAAFAAAADwAAAAAAAAAAAAAAAAAAAkUAAAAAQAAABQAAAAUAAAAFAAAAAEAAAAAAAAAZAAAAGQAAAAAAAAAZAAAAGQAAAAVAAAAYAAAAAAAAAAAAAAADwAAACADAAAAAAAAAAAAAAEAAACgMgAAVgcAAKr4//8BAAAAf39/AAEAAABkAAAAAAAAABQAAABAHwAAAAAAACYAAAAAAAAAwOD//wAAAAAmAAAAZAAAABYAAABMAAAAAAAAAAAAAAAEAAAAAAAAAAEAAABZWVkKAAAAACgAAAAoAAAAZAAAAGQAAAAAAAAAzMzMAAAAAABQAAAAUAAAAGQAAABkAAAAAAAAABcAAAAUAAAAAAAAAAAAAAD/fwAA/38AAAAAAAAJAAAABAAAAAAAAAAeAAAAaAAAAAAAAAAAAAAAAAAAAAAAAAAAAAAAECcAABAnAAAAAAAAAAAAAAAAAAAAAAAAAAAAAAAAAAAAAAAAAAAAABQAAAAAAAAAwMD/AAAAAABkAAAAMgAAAAAAAABkAAAAAAAAAH9/fwAKAAAAIgAAABgAAAAAAAAAAAAAAAAAAAAAAAAAAAAAAAAAAAAkAAAAJAAAAAAAAAAHAAAAAAAAAAAAAAAAAAAAAAAAAAAAAAAAAAAAf39/ACUAAABYAAAAAAAAAAAAAAAAAAAAAAAAAAAAAAAAAAAAAAAAAAAAAAAAAAAAAAAAAAAAAAA/AAAAAAAAAKCGAQAAAAAAAAAAAAAAAAAMAAAAAQAAAAAAAAAAAAAAAAAAAB8AAABUAAAAQoX0Bf///wEAAAAAAAAAAAAAAAAAAAAAAAAAAAAAAAAAAAAAAAAAAAAAAAJ/f38AWVlZA8zMzADAwP8Af39/AAAAAAAAAAAAAAAAAAAAAAAAAAAAIQAAABgAAAAUAAAAFAMAALYCAAB/NwAAvwoAABAAAAAmAAAACAAAAAAAAAAAAAAA"/>
               </a:ext>
             </a:extLst>
           </p:cNvSpPr>
@@ -9371,7 +9371,7 @@
             <a:spLocks noGrp="1" noChangeArrowheads="1"/>
             <a:extLst>
               <a:ext uri="smNativeData">
-                <pr:smNativeData xmlns:pr="smNativeData" xmlns="smNativeData" val="SMDATA_15_9kV5ZhMAAAAlAAAAZAAAAA0AAAAAkAAAAJAAAACQAAAAkAAAAAAAAAAAAAAAAAAAAAEAAABQAAAAAAAAAAAA4D8AAAAAAADgPwAAAAAAAOA/AAAAAAAA4D8AAAAAAADgPwAAAAAAAOA/AAAAAAAA4D8AAAAAAADgPwAAAAAAAOA/AAAAAAAA4D8CAAAAjAAAAAAAAAAAAAAAQoX0DP///wgAAAAAAAAAAAAAAAAAAAAAAAAAAAAAAAAAAAAAZAAAAAEAAABAAAAAAAAAAAAAAAAAAAAAAAAAAAAAAAAAAAAAAAAAAAAAAAAAAAAAAAAAAAAAAAAAAAAAAAAAAAAAAAAAAAAAAAAAAAAAAAAAAAAAAAAAAAAAAAAAAAAAFAAAADwAAAAAAAAAAAAAAAAAAAkUAAAAAQAAABQAAAAUAAAAFAAAAAEAAAAAAAAAZAAAAGQAAAAAAAAAZAAAAGQAAAAVAAAAYAAAAAAAAAAAAAAADwAAACADAAAAAAAAAAAAAAEAAACgMgAAVgcAAKr4//8BAAAAf39/AAEAAABkAAAAAAAAABQAAABAHwAAAAAAACYAAAAAAAAAwOD//wAAAAAmAAAAZAAAABYAAABMAAAAAAAAAAAAAAAEAAAAAAAAAAEAAABZWVkKAAAAACgAAAAoAAAAZAAAAGQAAAAAAAAAzMzMAAAAAABQAAAAUAAAAGQAAABkAAAAAAAAABcAAAAUAAAAAAAAAAAAAAD/fwAA/38AAAAAAAAJAAAABAAAAAAAAAAeAAAAaAAAAAAAAAAAAAAAAAAAAAAAAAAAAAAAECcAABAnAAAAAAAAAAAAAAAAAAAAAAAAAAAAAAAAAAAAAAAAAAAAABQAAAAAAAAAwMD/AAAAAABkAAAAMgAAAAAAAABkAAAAAAAAAH9/fwAKAAAAIgAAABgAAAAAAAAAAAAAAAAAAAAAAAAAAAAAAAAAAAAkAAAAJAAAAAAAAAAHAAAAAAAAAAAAAAAAAAAAAAAAAAAAAAAAAAAAf39/ACUAAABYAAAAAAAAAAAAAAAAAAAAAAAAAAAAAAAAAAAAAAAAAAAAAAAAAAAAAAAAAAAAAAA/AAAAAAAAAKCGAQAAAAAAAAAAAAAAAAAMAAAAAQAAAAAAAAAAAAAAAAAAAB8AAABUAAAAQoX0Bf///wEAAAAAAAAAAAAAAAAAAAAAAAAAAAAAAAAAAAAAAAAAAAAAAAJ/f38AWVlZA8zMzADAwP8Af39/AAAAAAAAAAAAAAAAAAAAAAAAAAAAIQAAABgAAAAUAAAAFAMAALMLAAB/NwAAuScAABAAAAAmAAAACAAAAAAAAAAAAAAA"/>
+                <pr:smNativeData xmlns:pr="smNativeData" xmlns="smNativeData" val="SMDATA_15_bQt8ZhMAAAAlAAAAZAAAAA0AAAAAkAAAAJAAAACQAAAAkAAAAAAAAAAAAAAAAAAAAAEAAABQAAAAAAAAAAAA4D8AAAAAAADgPwAAAAAAAOA/AAAAAAAA4D8AAAAAAADgPwAAAAAAAOA/AAAAAAAA4D8AAAAAAADgPwAAAAAAAOA/AAAAAAAA4D8CAAAAjAAAAAAAAAAAAAAAQoX0DP///wgAAAAAAAAAAAAAAAAAAAAAAAAAAAAAAAAAAAAAZAAAAAEAAABAAAAAAAAAAAAAAAAAAAAAAAAAAAAAAAAAAAAAAAAAAAAAAAAAAAAAAAAAAAAAAAAAAAAAAAAAAAAAAAAAAAAAAAAAAAAAAAAAAAAAAAAAAAAAAAAAAAAAFAAAADwAAAAAAAAAAAAAAAAAAAkUAAAAAQAAABQAAAAUAAAAFAAAAAEAAAAAAAAAZAAAAGQAAAAAAAAAZAAAAGQAAAAVAAAAYAAAAAAAAAAAAAAADwAAACADAAAAAAAAAAAAAAEAAACgMgAAVgcAAKr4//8BAAAAf39/AAEAAABkAAAAAAAAABQAAABAHwAAAAAAACYAAAAAAAAAwOD//wAAAAAmAAAAZAAAABYAAABMAAAAAAAAAAAAAAAEAAAAAAAAAAEAAABZWVkKAAAAACgAAAAoAAAAZAAAAGQAAAAAAAAAzMzMAAAAAABQAAAAUAAAAGQAAABkAAAAAAAAABcAAAAUAAAAAAAAAAAAAAD/fwAA/38AAAAAAAAJAAAABAAAAAAAAAAeAAAAaAAAAAAAAAAAAAAAAAAAAAAAAAAAAAAAECcAABAnAAAAAAAAAAAAAAAAAAAAAAAAAAAAAAAAAAAAAAAAAAAAABQAAAAAAAAAwMD/AAAAAABkAAAAMgAAAAAAAABkAAAAAAAAAH9/fwAKAAAAIgAAABgAAAAAAAAAAAAAAAAAAAAAAAAAAAAAAAAAAAAkAAAAJAAAAAAAAAAHAAAAAAAAAAAAAAAAAAAAAAAAAAAAAAAAAAAAf39/ACUAAABYAAAAAAAAAAAAAAAAAAAAAAAAAAAAAAAAAAAAAAAAAAAAAAAAAAAAAAAAAAAAAAA/AAAAAAAAAKCGAQAAAAAAAAAAAAAAAAAMAAAAAQAAAAAAAAAAAAAAAAAAAB8AAABUAAAAQoX0Bf///wEAAAAAAAAAAAAAAAAAAAAAAAAAAAAAAAAAAAAAAAAAAAAAAAJ/f38AWVlZA8zMzADAwP8Af39/AAAAAAAAAAAAAAAAAAAAAAAAAAAAIQAAABgAAAAUAAAAFAMAALMLAAB/NwAAuScAABAAAAAmAAAACAAAAAAAAAAAAAAA"/>
               </a:ext>
             </a:extLst>
           </p:cNvSpPr>
@@ -9448,7 +9448,7 @@
             <a:spLocks noGrp="1" noChangeArrowheads="1"/>
             <a:extLst>
               <a:ext uri="smNativeData">
-                <pr:smNativeData xmlns:pr="smNativeData" xmlns="smNativeData" val="SMDATA_15_9kV5ZhMAAAAlAAAAZAAAAA0AAAAAkAAAAJAAAACQAAAAkAAAAAAAAAAAAAAAAAAAAAEAAABQAAAAAAAAAAAA4D8AAAAAAADgPwAAAAAAAOA/AAAAAAAA4D8AAAAAAADgPwAAAAAAAOA/AAAAAAAA4D8AAAAAAADgPwAAAAAAAOA/AAAAAAAA4D8CAAAAjAAAAAAAAAAAAAAAQoX0DP///wgAAAAAAAAAAAAAAAAAAAAAAAAAAAAAAAAAAAAAZAAAAAEAAABAAAAAAAAAAAAAAAAAAAAAAAAAAAAAAAAAAAAAAAAAAAAAAAAAAAAAAAAAAAAAAAAAAAAAAAAAAAAAAAAAAAAAAAAAAAAAAAAAAAAAAAAAAAAAAAAAAAAAFAAAADwAAAAAAAAAAAAAAAAAAAkUAAAAAQAAABQAAAAUAAAAFAAAAAEAAAAAAAAAZAAAAGQAAAAAAAAAZAAAAGQAAAAVAAAAYAAAAAAAAAAAAAAADwAAACADAAAAAAAAAAAAAAEAAACgMgAAVgcAAKr4//8BAAAAf39/AAEAAABkAAAAAAAAABQAAABAHwAAAAAAACYAAAAAAAAAwOD//wAAAAAmAAAAZAAAABYAAABMAAAAAAAAAAAAAAAEAAAAAAAAAAEAAABZWVkKAAAAACgAAAAoAAAAZAAAAGQAAAAAAAAAzMzMAAAAAABQAAAAUAAAAGQAAABkAAAAAAAAABcAAAAUAAAAAAAAAAAAAAD/fwAA/38AAAAAAAAJAAAABAAAADtUGRUeAAAAaAAAAAAAAAAAAAAAAAAAAAAAAAAAAAAAECcAABAnAAAAAAAAAAAAAAAAAAAAAAAAAAAAAAAAAAAAAAAAAAAAABQAAAAAAAAAwMD/AAAAAABkAAAAMgAAAAAAAABkAAAAAAAAAH9/fwAKAAAAIgAAABgAAAAAAAAAAAAAAAAAAAAAAAAAAAAAAAAAAAAkAAAAJAAAAAAAAAAHAAAAAAAAAAAAAAAAAAAAAAAAAAAAAAAAAAAAf39/ACUAAABYAAAAAAAAAAAAAAAAAAAAAAAAAAAAAAAAAAAAAAAAAAAAAAAAAAAAAAAAAAAAAAA/AAAAAAAAAKCGAQAAAAAAAAAAAAAAAAAMAAAAAQAAAAAAAAAAAAAAAAAAAB8AAABUAAAAQoX0Bf///wEAAAAAAAAAAAAAAAAAAAAAAAAAAAAAAAAAAAAAAAAAAAAAAAJ/f38AWVlZA8zMzADAwP8Af39/AAAAAAAAAAAAAAAAAAAAAAAAAAAAIQAAABgAAAAUAAAA+gIAAIICAABlNwAAiwoAABAAAAAmAAAACAAAAD0wAAAAAAAA"/>
+                <pr:smNativeData xmlns:pr="smNativeData" xmlns="smNativeData" val="SMDATA_15_bQt8ZhMAAAAlAAAAZAAAAA0AAAAAkAAAAJAAAACQAAAAkAAAAAAAAAAAAAAAAAAAAAEAAABQAAAAAAAAAAAA4D8AAAAAAADgPwAAAAAAAOA/AAAAAAAA4D8AAAAAAADgPwAAAAAAAOA/AAAAAAAA4D8AAAAAAADgPwAAAAAAAOA/AAAAAAAA4D8CAAAAjAAAAAAAAAAAAAAAQoX0DP///wgAAAAAAAAAAAAAAAAAAAAAAAAAAAAAAAAAAAAAZAAAAAEAAABAAAAAAAAAAAAAAAAAAAAAAAAAAAAAAAAAAAAAAAAAAAAAAAAAAAAAAAAAAAAAAAAAAAAAAAAAAAAAAAAAAAAAAAAAAAAAAAAAAAAAAAAAAAAAAAAAAAAAFAAAADwAAAAAAAAAAAAAAAAAAAkUAAAAAQAAABQAAAAUAAAAFAAAAAEAAAAAAAAAZAAAAGQAAAAAAAAAZAAAAGQAAAAVAAAAYAAAAAAAAAAAAAAADwAAACADAAAAAAAAAAAAAAEAAACgMgAAVgcAAKr4//8BAAAAf39/AAEAAABkAAAAAAAAABQAAABAHwAAAAAAACYAAAAAAAAAwOD//wAAAAAmAAAAZAAAABYAAABMAAAAAAAAAAAAAAAEAAAAAAAAAAEAAABZWVkKAAAAACgAAAAoAAAAZAAAAGQAAAAAAAAAzMzMAAAAAABQAAAAUAAAAGQAAABkAAAAAAAAABcAAAAUAAAAAAAAAAAAAAD/fwAA/38AAAAAAAAJAAAABAAAADtUGRUeAAAAaAAAAAAAAAAAAAAAAAAAAAAAAAAAAAAAECcAABAnAAAAAAAAAAAAAAAAAAAAAAAAAAAAAAAAAAAAAAAAAAAAABQAAAAAAAAAwMD/AAAAAABkAAAAMgAAAAAAAABkAAAAAAAAAH9/fwAKAAAAIgAAABgAAAAAAAAAAAAAAAAAAAAAAAAAAAAAAAAAAAAkAAAAJAAAAAAAAAAHAAAAAAAAAAAAAAAAAAAAAAAAAAAAAAAAAAAAf39/ACUAAABYAAAAAAAAAAAAAAAAAAAAAAAAAAAAAAAAAAAAAAAAAAAAAAAAAAAAAAAAAAAAAAA/AAAAAAAAAKCGAQAAAAAAAAAAAAAAAAAMAAAAAQAAAAAAAAAAAAAAAAAAAB8AAABUAAAAQoX0Bf///wEAAAAAAAAAAAAAAAAAAAAAAAAAAAAAAAAAAAAAAAAAAAAAAAJ/f38AWVlZA8zMzADAwP8Af39/AAAAAAAAAAAAAAAAAAAAAAAAAAAAIQAAABgAAAAUAAAA+gIAAIICAABlNwAAiwoAABAAAAAmAAAACAAAAD0wAAAAAAAA"/>
               </a:ext>
             </a:extLst>
           </p:cNvSpPr>
@@ -9509,85 +9509,14 @@
           </a:p>
         </p:txBody>
       </p:sp>
-      <p:sp>
-        <p:nvSpPr>
-          <p:cNvPr id="3" name="Google Shape;197;p38"/>
-          <p:cNvSpPr>
-            <a:extLst>
-              <a:ext uri="smNativeData">
-                <pr:smNativeData xmlns:pr="smNativeData" xmlns="smNativeData" val="SMDATA_15_9kV5ZhMAAAAlAAAA9AEAAA0AAAAAOAEAAMYAAAA4AQAAxgAAAAAAAAABAAAAAAAAAAEAAABQAAAAtSRVET1m6b8FJ9au5qX6vwAAAAAAAOA/AAAAAAAA4D8AAAAAAADgPwAAAAAAAOA/AAAAAAAA4D8AAAAAAADgPwAAAAAAAOA/AAAAAAAA4D8CAAAAjAAAAAEAAAAAAAAA8/PzAP///wgAAAAAAAAAAAAAAAAAAAAAAAAAAAAAAAAAAAAAeAAAAAEAAABAAAAAAAAAAAAAAABaAAAAAAAAAAAAAAAAAAAAAAAAAAAAAAAAAAAAAAAAAAAAAAAAAAAAAAAAAAAAAAAAAAAAAAAAAAAAAAAAAAAAAAAAAAAAAAAAAAAAFAAAADwAAAABAAAAAAAAAAE9hQAPAAAAAQAAACMAAAAjAAAAIwAAAB4AAAAAAAAASwAAAEsAAAAAAAAASwAAAEsAAAAVAAAAYAAAAAAAAAAAAAAADwAAACADAAAAAAAAAAAAAAEAAACgMgAAVgcAAKr4//8BAAAAf39/AAEAAABkAAAAAAAAABQAAABAHwAAAAAAACYAAAAAAAAAwOD//wAAAAAmAAAAZAAAABYAAABMAAAAAAAAAAAAAAAEAAAAAAAAAAEAAABZWVkKAAAAACgAAAAoAAAAZAAAAGQAAAAAAAAAzMzMAAAAAABQAAAAUAAAAGQAAABkAAAAAAAAABcAAAAUAAAAAAAAAAAAAAD/fwAA/38AAAAAAAAJAAAABAAAAG+pTlkeAAAAaAAAAAAAAAAAAAAAAAAAAAAAAAAAAAAAECcAABAnAAAAAAAAAAAAAAAAAAAAAAAAAAAAAAAAAAAAAAAAAAAAABQAAAAAAAAAwMD/AAAAAABkAAAAMgAAAAAAAABkAAAAAAAAAH9/fwAKAAAAIgAAABgAAAAAAAAAAAAAAAAAAAAAAAAAAAAAAAAAAAAkAAAAJAAAAAAAAAAHAAAAAAAAAAAAAAAAAAAAAAAAAAAAAAAAAAAAf39/ACUAAABYAAAAAAAAAAAAAAAAAAAAAAAAAAAAAAAAAAAAAAAAAAAAAAAAAAAAAAAAAAAAAAA/AAAAAAAAAKCGAQAAAAAAAAAAAAAAAAAMAAAAAQAAAAAAAAAAAAAAAAAAAB8AAABUAAAA8/PzAP///wEAAAAAAAAAAAAAAAAAAAAAAAAAAAAAAAAAAAAAAAAAAAE9hQB/f38AWVlZA8zMzADAwP8Af39/AAAAAAAAAAAAAAAAAAAAAAAAAAAAIQAAABgAAAAUAAAAvR0AAO0fAADMMgAApCYAABAAAAAmAAAACAAAAP//////////"/>
-              </a:ext>
-            </a:extLst>
-          </p:cNvSpPr>
-          <p:nvPr/>
-        </p:nvSpPr>
-        <p:spPr>
-          <a:xfrm>
-            <a:off x="4834255" y="5189855"/>
-            <a:ext cx="3423285" cy="1091565"/>
-          </a:xfrm>
-          <a:prstGeom prst="wedgeRectCallout">
-            <a:avLst>
-              <a:gd name="adj1" fmla="val -39687"/>
-              <a:gd name="adj2" fmla="val -83275"/>
-            </a:avLst>
-          </a:prstGeom>
-          <a:solidFill>
-            <a:srgbClr val="F3F3F3"/>
-          </a:solidFill>
-          <a:ln w="9525" cap="flat" cmpd="sng" algn="ctr">
-            <a:solidFill>
-              <a:srgbClr val="013D85"/>
-            </a:solidFill>
-            <a:prstDash val="solid"/>
-            <a:headEnd type="none"/>
-            <a:tailEnd type="none"/>
-          </a:ln>
-          <a:effectLst/>
-        </p:spPr>
-        <p:txBody>
-          <a:bodyPr vert="horz" wrap="square" lIns="198120" tIns="125730" rIns="198120" bIns="125730" numCol="1" spcCol="215900" anchor="ctr"/>
-          <a:lstStyle/>
-          <a:p>
-            <a:pPr marL="0" indent="0" algn="l">
-              <a:spcBef>
-                <a:spcPts val="600"/>
-              </a:spcBef>
-              <a:spcAft>
-                <a:spcPts val="0"/>
-              </a:spcAft>
-              <a:buNone/>
-            </a:pPr>
-            <a:r>
-              <a:rPr lang="ru-ru" sz="1500" cap="none">
-                <a:solidFill>
-                  <a:srgbClr val="02418B"/>
-                </a:solidFill>
-                <a:latin typeface="Roboto" pitchFamily="0" charset="0"/>
-                <a:ea typeface="Roboto" pitchFamily="0" charset="0"/>
-                <a:cs typeface="Roboto" pitchFamily="0" charset="0"/>
-              </a:rPr>
-              <a:t>Опционально, если ваш проект позволяет это сделать</a:t>
-            </a:r>
-            <a:endParaRPr sz="1500" cap="none">
-              <a:solidFill>
-                <a:srgbClr val="02418B"/>
-              </a:solidFill>
-              <a:latin typeface="Roboto" pitchFamily="0" charset="0"/>
-              <a:ea typeface="Roboto" pitchFamily="0" charset="0"/>
-              <a:cs typeface="Roboto" pitchFamily="0" charset="0"/>
-            </a:endParaRPr>
-          </a:p>
-        </p:txBody>
-      </p:sp>
       <p:pic>
         <p:nvPicPr>
-          <p:cNvPr id="4" name="Изображение1"/>
+          <p:cNvPr id="3" name="Изображение1"/>
           <p:cNvPicPr>
             <a:picLocks noChangeAspect="1"/>
             <a:extLst>
               <a:ext uri="smNativeData">
-                <pr:smNativeData xmlns:pr="smNativeData" xmlns="smNativeData" val="SMDATA_17_9kV5ZhMAAAAlAAAAEQAAAC8BAAAAkAAAAEgAAACQAAAASAAAAAAAAAAAAAAAAAAAAAEAAABQAAAAAAAAAAAA4D8AAAAAAADgPwAAAAAAAOA/AAAAAAAA4D8AAAAAAADgPwAAAAAAAOA/AAAAAAAA4D8AAAAAAADgPwAAAAAAAOA/AAAAAAAA4D8CAAAAjAAAAAAAAAAAAAAAQoX0DP///wgAAAAAAAAAAAAAAAAAAAAAAAAAAAAAAAAAAAAAZAAAAAEAAABAAAAAAAAAAAAAAAAAAAAAAAAAAAAAAAAAAAAAAAAAAAAAAAAAAAAAAAAAAAAAAAAAAAAAAAAAAAAAAAAAAAAAAAAAAAAAAAAAAAAAAAAAAAAAAAAAAAAAFAAAADwAAAAAAAAAAAAAAAAAAAkUAAAAAQAAABQAAAAUAAAAFAAAAAEAAAAAAAAAZAAAAGQAAAAAAAAAZAAAAGQAAAAVAAAAYAAAAAAAAAAAAAAADwAAACADAAAAAAAAAAAAAAEAAACgMgAAVgcAAKr4//8BAAAAf39/AAEAAABkAAAAAAAAABQAAABAHwAAAAAAACYAAAAAAAAAwOD//wAAAAAmAAAAZAAAABYAAABMAAAAAAAAAAAAAAAEAAAAAAAAAAEAAABZWVkKAAAAACgAAAAoAAAAZAAAAGQAAAAAAAAAzMzMAAAAAABQAAAAUAAAAGQAAABkAAAAAAAAAAcAAAA4AAAAAAAAAAAAAAAAAAAA////AAAAAAAAAAAAAAAAAAAAAAAAAAAAAAAAAAAAAABkAAAAZAAAAAAAAAAjAAAABAAAAGQAAAAXAAAAFAAAAAAAAAAAAAAA/38AAP9/AAAAAAAACQAAAAQAAAAOAAAAHgAAAGgAAAAAAAAAAAAAAAAAAAAAAAAAAAAAABAnAAAQJwAAAAAAAAAAAAAAAAAAAAAAAAAAAAAAAAAAAAAAAAAAAAAUAAAAAAAAAMDA/wAAAAAAZAAAADIAAAAAAAAAZAAAAAAAAAB/f38ACgAAACIAAAAYAAAAAAAAAAAAAAAAAAAAAAAAAAAAAAAAAAAAJAAAACQAAAAAAAAABwAAAAAAAAAAAAAAAAAAAAAAAAAAAAAAAAAAAH9/fwAlAAAAWAAAAAAAAAAAAAAAAAAAAAAAAAAAAAAAAAAAAAAAAAAAAAAAAAAAAAAAAAAAAAAAPwAAAAAAAACghgEAAAAAAAAAAAAAAAAADAAAAAEAAAAAAAAAAAAAAAAAAAAfAAAAVAAAAEKF9AX///8BAAAAAAAAAAAAAAAAAAAAAAAAAAAAAAAAAAAAAAAAAAAAAAACf39/AFlZWQPMzMwAwMD/AH9/fwAAAAAAAAAAAAAAAAD///8AAAAAACEAAAAYAAAAFAAAAAUDAAB5CwAAQzcAAMkcAAAQAAAAJgAAAAgAAAD//////////w=="/>
+                <pr:smNativeData xmlns:pr="smNativeData" xmlns="smNativeData" val="SMDATA_17_bQt8ZhMAAAAlAAAAEQAAAC8BAAAAkAAAAEgAAACQAAAASAAAAAAAAAAAAAAAAAAAAAEAAABQAAAAAAAAAAAA4D8AAAAAAADgPwAAAAAAAOA/AAAAAAAA4D8AAAAAAADgPwAAAAAAAOA/AAAAAAAA4D8AAAAAAADgPwAAAAAAAOA/AAAAAAAA4D8CAAAAjAAAAAAAAAAAAAAAQoX0DP///wgAAAAAAAAAAAAAAAAAAAAAAAAAAAAAAAAAAAAAZAAAAAEAAABAAAAAAAAAAAAAAAAAAAAAAAAAAAAAAAAAAAAAAAAAAAAAAAAAAAAAAAAAAAAAAAAAAAAAAAAAAAAAAAAAAAAAAAAAAAAAAAAAAAAAAAAAAAAAAAAAAAAAFAAAADwAAAAAAAAAAAAAAAAAAAkUAAAAAQAAABQAAAAUAAAAFAAAAAEAAAAAAAAAZAAAAGQAAAAAAAAAZAAAAGQAAAAVAAAAYAAAAAAAAAAAAAAADwAAACADAAAAAAAAAAAAAAEAAACgMgAAVgcAAKr4//8BAAAAf39/AAEAAABkAAAAAAAAABQAAABAHwAAAAAAACYAAAAAAAAAwOD//wAAAAAmAAAAZAAAABYAAABMAAAAAAAAAAAAAAAEAAAAAAAAAAEAAABZWVkKAAAAACgAAAAoAAAAZAAAAGQAAAAAAAAAzMzMAAAAAABQAAAAUAAAAGQAAABkAAAAAAAAAAcAAAA4AAAAAAAAAAAAAAAAAAAA////AAAAAAAAAAAAAAAAAAAAAAAAAAAAAAAAAAAAAABkAAAAZAAAAAAAAAAjAAAABAAAAGQAAAAXAAAAFAAAAAAAAAAAAAAA/38AAP9/AAAAAAAACQAAAAQAAAAOAAAAHgAAAGgAAAAAAAAAAAAAAAAAAAAAAAAAAAAAABAnAAAQJwAAAAAAAAAAAAAAAAAAAAAAAAAAAAAAAAAAAAAAAAAAAAAUAAAAAAAAAMDA/wAAAAAAZAAAADIAAAAAAAAAZAAAAAAAAAB/f38ACgAAACIAAAAYAAAAAAAAAAAAAAAAAAAAAAAAAAAAAAAAAAAAJAAAACQAAAAAAAAABwAAAAAAAAAAAAAAAAAAAAAAAAAAAAAAAAAAAH9/fwAlAAAAWAAAAAAAAAAAAAAAAAAAAAAAAAAAAAAAAAAAAAAAAAAAAAAAAAAAAAAAAAAAAAAAPwAAAAAAAACghgEAAAAAAAAAAAAAAAAADAAAAAEAAAAAAAAAAAAAAAAAAAAfAAAAVAAAAEKF9AX///8BAAAAAAAAAAAAAAAAAAAAAAAAAAAAAAAAAAAAAAAAAAAAAAACf39/AFlZWQPMzMwAwMD/AH9/fwAAAAAAAAAAAAAAAAD///8AAAAAACEAAAAYAAAAFAAAAAUDAAB5CwAAQzcAAMkcAAAQAAAAJgAAAAgAAAD//////////w=="/>
               </a:ext>
             </a:extLst>
           </p:cNvPicPr>
@@ -9653,7 +9582,7 @@
             <a:spLocks noGrp="1" noChangeArrowheads="1"/>
             <a:extLst>
               <a:ext uri="smNativeData">
-                <pr:smNativeData xmlns:pr="smNativeData" xmlns="smNativeData" val="SMDATA_15_9kV5ZhMAAAAlAAAAZAAAAA0AAAAAkAAAAJAAAACQAAAAkAAAAAAAAAAAAAAAAAAAAAEAAABQAAAAAAAAAAAA4D8AAAAAAADgPwAAAAAAAOA/AAAAAAAA4D8AAAAAAADgPwAAAAAAAOA/AAAAAAAA4D8AAAAAAADgPwAAAAAAAOA/AAAAAAAA4D8CAAAAjAAAAAAAAAAAAAAAQoX0DP///wgAAAAAAAAAAAAAAAAAAAAAAAAAAAAAAAAAAAAAZAAAAAEAAABAAAAAAAAAAAAAAAAAAAAAAAAAAAAAAAAAAAAAAAAAAAAAAAAAAAAAAAAAAAAAAAAAAAAAAAAAAAAAAAAAAAAAAAAAAAAAAAAAAAAAAAAAAAAAAAAAAAAAFAAAADwAAAAAAAAAAAAAAAAAAAkUAAAAAQAAABQAAAAUAAAAFAAAAAEAAAAAAAAAZAAAAGQAAAAAAAAAZAAAAGQAAAAVAAAAYAAAAAAAAAAAAAAADwAAACADAAAAAAAAAAAAAAEAAACgMgAAVgcAAKr4//8BAAAAf39/AAEAAABkAAAAAAAAABQAAABAHwAAAAAAACYAAAAAAAAAwOD//wAAAAAmAAAAZAAAABYAAABMAAAAAAAAAAAAAAAEAAAAAAAAAAEAAABZWVkKAAAAACgAAAAoAAAAZAAAAGQAAAAAAAAAzMzMAAAAAABQAAAAUAAAAGQAAABkAAAAAAAAABcAAAAUAAAAAAAAAAAAAAD/fwAA/38AAAAAAAAJAAAABAAAAI+nzTQeAAAAaAAAAAAAAAAAAAAAAAAAAAAAAAAAAAAAECcAABAnAAAAAAAAAAAAAAAAAAAAAAAAAAAAAAAAAAAAAAAAAAAAABQAAAAAAAAAwMD/AAAAAABkAAAAMgAAAAAAAABkAAAAAAAAAH9/fwAKAAAAIgAAABgAAAAAAAAAAAAAAAAAAAAAAAAAAAAAAAAAAAAkAAAAJAAAAAAAAAAHAAAAAAAAAAAAAAAAAAAAAAAAAAAAAAAAAAAAf39/ACUAAABYAAAAAAAAAAAAAAAAAAAAAAAAAAAAAAAAAAAAAAAAAAAAAAAAAAAAAAAAAAAAAAA/AAAAAAAAAKCGAQAAAAAAAAAAAAAAAAAMAAAAAQAAAAAAAAAAAAAAAAAAAB8AAABUAAAAQoX0Bf///wEAAAAAAAAAAAAAAAAAAAAAAAAAAAAAAAAAAAAAAAAAAAAAAAJ/f38AWVlZA8zMzADAwP8Af39/AAAAAAAAAAAAAAAAAAAAAAAAAAAAIQAAABgAAAAUAAAAFAMAALYCAAB/NwAAvwoAABAAAAAmAAAACAAAADwwAAAAAAAA"/>
+                <pr:smNativeData xmlns:pr="smNativeData" xmlns="smNativeData" val="SMDATA_15_bQt8ZhMAAAAlAAAAZAAAAA0AAAAAkAAAAJAAAACQAAAAkAAAAAAAAAAAAAAAAAAAAAEAAABQAAAAAAAAAAAA4D8AAAAAAADgPwAAAAAAAOA/AAAAAAAA4D8AAAAAAADgPwAAAAAAAOA/AAAAAAAA4D8AAAAAAADgPwAAAAAAAOA/AAAAAAAA4D8CAAAAjAAAAAAAAAAAAAAAQoX0DP///wgAAAAAAAAAAAAAAAAAAAAAAAAAAAAAAAAAAAAAZAAAAAEAAABAAAAAAAAAAAAAAAAAAAAAAAAAAAAAAAAAAAAAAAAAAAAAAAAAAAAAAAAAAAAAAAAAAAAAAAAAAAAAAAAAAAAAAAAAAAAAAAAAAAAAAAAAAAAAAAAAAAAAFAAAADwAAAAAAAAAAAAAAAAAAAkUAAAAAQAAABQAAAAUAAAAFAAAAAEAAAAAAAAAZAAAAGQAAAAAAAAAZAAAAGQAAAAVAAAAYAAAAAAAAAAAAAAADwAAACADAAAAAAAAAAAAAAEAAACgMgAAVgcAAKr4//8BAAAAf39/AAEAAABkAAAAAAAAABQAAABAHwAAAAAAACYAAAAAAAAAwOD//wAAAAAmAAAAZAAAABYAAABMAAAAAAAAAAAAAAAEAAAAAAAAAAEAAABZWVkKAAAAACgAAAAoAAAAZAAAAGQAAAAAAAAAzMzMAAAAAABQAAAAUAAAAGQAAABkAAAAAAAAABcAAAAUAAAAAAAAAAAAAAD/fwAA/38AAAAAAAAJAAAABAAAAI+nzTQeAAAAaAAAAAAAAAAAAAAAAAAAAAAAAAAAAAAAECcAABAnAAAAAAAAAAAAAAAAAAAAAAAAAAAAAAAAAAAAAAAAAAAAABQAAAAAAAAAwMD/AAAAAABkAAAAMgAAAAAAAABkAAAAAAAAAH9/fwAKAAAAIgAAABgAAAAAAAAAAAAAAAAAAAAAAAAAAAAAAAAAAAAkAAAAJAAAAAAAAAAHAAAAAAAAAAAAAAAAAAAAAAAAAAAAAAAAAAAAf39/ACUAAABYAAAAAAAAAAAAAAAAAAAAAAAAAAAAAAAAAAAAAAAAAAAAAAAAAAAAAAAAAAAAAAA/AAAAAAAAAKCGAQAAAAAAAAAAAAAAAAAMAAAAAQAAAAAAAAAAAAAAAAAAAB8AAABUAAAAQoX0Bf///wEAAAAAAAAAAAAAAAAAAAAAAAAAAAAAAAAAAAAAAAAAAAAAAAJ/f38AWVlZA8zMzADAwP8Af39/AAAAAAAAAAAAAAAAAAAAAAAAAAAAIQAAABgAAAAUAAAAFAMAALYCAAB/NwAAvwoAABAAAAAmAAAACAAAADwwAAAAAAAA"/>
               </a:ext>
             </a:extLst>
           </p:cNvSpPr>
@@ -9843,7 +9772,7 @@
                 </a:tc>
                 <a:extLst>
                   <a:ext uri="smNativeData">
-                    <pr:rowheight xmlns="" xmlns:pr="smNativeData" dt="1719223798" type="min" val="381000"/>
+                    <pr:rowheight xmlns="" xmlns:pr="smNativeData" dt="1719405421" type="min" val="381000"/>
                   </a:ext>
                 </a:extLst>
               </a:tr>
@@ -9991,7 +9920,7 @@
                 </a:tc>
                 <a:extLst>
                   <a:ext uri="smNativeData">
-                    <pr:rowheight xmlns="" xmlns:pr="smNativeData" dt="1719223798" type="min" val="381000"/>
+                    <pr:rowheight xmlns="" xmlns:pr="smNativeData" dt="1719405421" type="min" val="381000"/>
                   </a:ext>
                 </a:extLst>
               </a:tr>
@@ -10139,7 +10068,7 @@
                 </a:tc>
                 <a:extLst>
                   <a:ext uri="smNativeData">
-                    <pr:rowheight xmlns="" xmlns:pr="smNativeData" dt="1719223798" type="min" val="381000"/>
+                    <pr:rowheight xmlns="" xmlns:pr="smNativeData" dt="1719405421" type="min" val="381000"/>
                   </a:ext>
                 </a:extLst>
               </a:tr>
@@ -10147,77 +10076,6 @@
           </a:graphicData>
         </a:graphic>
       </p:graphicFrame>
-      <p:sp>
-        <p:nvSpPr>
-          <p:cNvPr id="4" name="Google Shape;204;p39"/>
-          <p:cNvSpPr>
-            <a:extLst>
-              <a:ext uri="smNativeData">
-                <pr:smNativeData xmlns:pr="smNativeData" xmlns="smNativeData" val="SMDATA_15_9kV5ZhMAAAAlAAAA9AEAAA0AAAAAOAEAAMYAAAA4AQAAxgAAAAAAAAABAAAAAAAAAAEAAABQAAAAEXC47Anh479Fb0gmzk0BwAAAAAAAAOA/AAAAAAAA4D8AAAAAAADgPwAAAAAAAOA/AAAAAAAA4D8AAAAAAADgPwAAAAAAAOA/AAAAAAAA4D8CAAAAjAAAAAEAAAAAAAAA8/PzAP///wgAAAAAAAAAAAAAAAAAAAAAAAAAAAAAAAAAAAAAeAAAAAEAAABAAAAAAAAAAAAAAABaAAAAAAAAAAAAAAAAAAAAAAAAAAAAAAAAAAAAAAAAAAAAAAAAAAAAAAAAAAAAAAAAAAAAAAAAAAAAAAAAAAAAAAAAAAAAAAAAAAAAFAAAADwAAAABAAAAAAAAAAE9hQAPAAAAAQAAACMAAAAjAAAAIwAAAB4AAAAAAAAASwAAAEsAAAAAAAAASwAAAEsAAAAVAAAAYAAAAAAAAAAAAAAADwAAACADAAAAAAAAAAAAAAEAAACgMgAAVgcAAKr4//8BAAAAf39/AAEAAABkAAAAAAAAABQAAABAHwAAAAAAACYAAAAAAAAAwOD//wAAAAAmAAAAZAAAABYAAABMAAAAAAAAAAAAAAAEAAAAAAAAAAEAAABZWVkKAAAAACgAAAAoAAAAZAAAAGQAAAAAAAAAzMzMAAAAAABQAAAAUAAAAGQAAABkAAAAAAAAABcAAAAUAAAAAAAAAAAAAAD/fwAA/38AAAAAAAAJAAAABAAAADkxY2geAAAAaAAAAAAAAAAAAAAAAAAAAAAAAAAAAAAAECcAABAnAAAAAAAAAAAAAAAAAAAAAAAAAAAAAAAAAAAAAAAAAAAAABQAAAAAAAAAwMD/AAAAAABkAAAAMgAAAAAAAABkAAAAAAAAAH9/fwAKAAAAIgAAABgAAAAAAAAAAAAAAAAAAAAAAAAAAAAAAAAAAAAkAAAAJAAAAAAAAAAHAAAAAAAAAAAAAAAAAAAAAAAAAAAAAAAAAAAAf39/ACUAAABYAAAAAAAAAAAAAAAAAAAAAAAAAAAAAAAAAAAAAAAAAAAAAAAAAAAAAAAAAAAAAAA/AAAAAAAAAKCGAQAAAAAAAAAAAAAAAAAMAAAAAQAAAAAAAAAAAAAAAAAAAB8AAABUAAAA8/PzAP///wEAAAAAAAAAAAAAAAAAAAAAAAAAAAAAAAAAAAAAAAAAAAE9hQB/f38AWVlZA8zMzADAwP8Af39/AAAAAAAAAAAAAAAAAAAAAAAAAAAAIQAAABgAAAAUAAAAVR0AAO0iAABkMgAAMCoAABAAAAAmAAAACAAAAP//////////"/>
-              </a:ext>
-            </a:extLst>
-          </p:cNvSpPr>
-          <p:nvPr/>
-        </p:nvSpPr>
-        <p:spPr>
-          <a:xfrm>
-            <a:off x="4768215" y="5677535"/>
-            <a:ext cx="3423285" cy="1180465"/>
-          </a:xfrm>
-          <a:prstGeom prst="wedgeRectCallout">
-            <a:avLst>
-              <a:gd name="adj1" fmla="val -31061"/>
-              <a:gd name="adj2" fmla="val -108150"/>
-            </a:avLst>
-          </a:prstGeom>
-          <a:solidFill>
-            <a:srgbClr val="F3F3F3"/>
-          </a:solidFill>
-          <a:ln w="9525" cap="flat" cmpd="sng" algn="ctr">
-            <a:solidFill>
-              <a:srgbClr val="013D85"/>
-            </a:solidFill>
-            <a:prstDash val="solid"/>
-            <a:headEnd type="none"/>
-            <a:tailEnd type="none"/>
-          </a:ln>
-          <a:effectLst/>
-        </p:spPr>
-        <p:txBody>
-          <a:bodyPr vert="horz" wrap="square" lIns="198120" tIns="125730" rIns="198120" bIns="125730" numCol="1" spcCol="215900" anchor="ctr"/>
-          <a:lstStyle/>
-          <a:p>
-            <a:pPr marL="0" indent="0" algn="l">
-              <a:spcBef>
-                <a:spcPts val="600"/>
-              </a:spcBef>
-              <a:spcAft>
-                <a:spcPts val="0"/>
-              </a:spcAft>
-              <a:buNone/>
-            </a:pPr>
-            <a:r>
-              <a:rPr lang="ru-ru" sz="1500" cap="none">
-                <a:solidFill>
-                  <a:srgbClr val="02418B"/>
-                </a:solidFill>
-                <a:latin typeface="Roboto" pitchFamily="0" charset="0"/>
-                <a:ea typeface="Roboto" pitchFamily="0" charset="0"/>
-                <a:cs typeface="Roboto" pitchFamily="0" charset="0"/>
-              </a:rPr>
-              <a:t>Запланируйте пару минут на рефлексию в конце защиты проекта и расскажите о планах по развитию</a:t>
-            </a:r>
-            <a:endParaRPr sz="1500" cap="none">
-              <a:solidFill>
-                <a:srgbClr val="02418B"/>
-              </a:solidFill>
-              <a:latin typeface="Roboto" pitchFamily="0" charset="0"/>
-              <a:ea typeface="Roboto" pitchFamily="0" charset="0"/>
-              <a:cs typeface="Roboto" pitchFamily="0" charset="0"/>
-            </a:endParaRPr>
-          </a:p>
-        </p:txBody>
-      </p:sp>
     </p:spTree>
   </p:cSld>
   <p:clrMapOvr>
@@ -10257,7 +10115,7 @@
             <a:spLocks noGrp="1" noChangeArrowheads="1"/>
             <a:extLst>
               <a:ext uri="smNativeData">
-                <pr:smNativeData xmlns:pr="smNativeData" xmlns="smNativeData" val="SMDATA_15_9kV5ZhMAAAAlAAAAZAAAAA0AAAAAkAAAAJAAAACQAAAAkAAAAAAAAAABAAAAAAAAAAEAAABQAAAAAAAAAAAA4D8AAAAAAADgPwAAAAAAAOA/AAAAAAAA4D8AAAAAAADgPwAAAAAAAOA/AAAAAAAA4D8AAAAAAADgPwAAAAAAAOA/AAAAAAAA4D8CAAAAjAAAAAAAAAAAAAAAQoX0DP///wgAAAAAAAAAAAAAAAAAAAAAAAAAAAAAAAAAAAAAZAAAAAEAAABAAAAAAAAAAAAAAAAAAAAAAAAAAAAAAAAAAAAAAAAAAAAAAAAAAAAAAAAAAAAAAAAAAAAAAAAAAAAAAAAAAAAAAAAAAAAAAAAAAAAAAAAAAAAAAAAAAAAAFAAAADwAAAAAAAAAAAAAAAAAAAkUAAAAAQAAABQAAAAUAAAAFAAAAAEAAAAAAAAAZAAAAGQAAAAAAAAAZAAAAGQAAAAVAAAAYAAAAAAAAAAAAAAADwAAACADAAAAAAAAAAAAAAEAAACgMgAAVgcAAKr4//8BAAAAf39/AAEAAABkAAAAAAAAABQAAABAHwAAAAAAACYAAAAAAAAAwOD//wAAAAAmAAAAZAAAABYAAABMAAAAAAAAAAAAAAAEAAAAAAAAAAEAAABZWVkKAAAAACgAAAAoAAAAZAAAAGQAAAAAAAAAzMzMAAAAAABQAAAAUAAAAGQAAABkAAAAAAAAABcAAAAUAAAAAAAAAAAAAAD/fwAA/38AAAAAAAAJAAAABAAAAJx8t8UeAAAAaAAAAAAAAAAAAAAAAAAAAAAAAAAAAAAAECcAABAnAAAAAAAAAAAAAAAAAAAAAAAAAAAAAAAAAAAAAAAAAAAAABQAAAAAAAAAwMD/AAAAAABkAAAAMgAAAAAAAABkAAAAAAAAAH9/fwAKAAAAIgAAABgAAAAAAAAAAAAAAAAAAAAAAAAAAAAAAAAAAAAkAAAAJAAAAAAAAAAHAAAAAAAAAAAAAAAAAAAAAAAAAAAAAAAAAAAAf39/ACUAAABYAAAAAAAAAAAAAAAAAAAAAAAAAAAAAAAAAAAAAAAAAAAAAAAAAAAAAAAAAAAAAAA/AAAAAAAAAKCGAQAAAAAAAAAAAAAAAAAMAAAAAQAAAAAAAAAAAAAAAAAAAB8AAABUAAAAQoX0Bf///wEAAAAAAAAAAAAAAAAAAAAAAAAAAAAAAAAAAAAAAAAAAAAAAAJ/f38AWVlZA8zMzADAwP8Af39/AAAAAAAAAAAAAAAAAAAAAAAAAAAAIQAAABgAAAAUAAAA4gUAAEADAABiNAAAziQAABAAAAAmAAAACAAAAD0wAAAAAAAA"/>
+                <pr:smNativeData xmlns:pr="smNativeData" xmlns="smNativeData" val="SMDATA_15_bQt8ZhMAAAAlAAAAZAAAAA0AAAAAkAAAAJAAAACQAAAAkAAAAAAAAAABAAAAAAAAAAEAAABQAAAAAAAAAAAA4D8AAAAAAADgPwAAAAAAAOA/AAAAAAAA4D8AAAAAAADgPwAAAAAAAOA/AAAAAAAA4D8AAAAAAADgPwAAAAAAAOA/AAAAAAAA4D8CAAAAjAAAAAAAAAAAAAAAQoX0DP///wgAAAAAAAAAAAAAAAAAAAAAAAAAAAAAAAAAAAAAZAAAAAEAAABAAAAAAAAAAAAAAAAAAAAAAAAAAAAAAAAAAAAAAAAAAAAAAAAAAAAAAAAAAAAAAAAAAAAAAAAAAAAAAAAAAAAAAAAAAAAAAAAAAAAAAAAAAAAAAAAAAAAAFAAAADwAAAAAAAAAAAAAAAAAAAkUAAAAAQAAABQAAAAUAAAAFAAAAAEAAAAAAAAAZAAAAGQAAAAAAAAAZAAAAGQAAAAVAAAAYAAAAAAAAAAAAAAADwAAACADAAAAAAAAAAAAAAEAAACgMgAAVgcAAKr4//8BAAAAf39/AAEAAABkAAAAAAAAABQAAABAHwAAAAAAACYAAAAAAAAAwOD//wAAAAAmAAAAZAAAABYAAABMAAAAAAAAAAAAAAAEAAAAAAAAAAEAAABZWVkKAAAAACgAAAAoAAAAZAAAAGQAAAAAAAAAzMzMAAAAAABQAAAAUAAAAGQAAABkAAAAAAAAABcAAAAUAAAAAAAAAAAAAAD/fwAA/38AAAAAAAAJAAAABAAAAJx8t8UeAAAAaAAAAAAAAAAAAAAAAAAAAAAAAAAAAAAAECcAABAnAAAAAAAAAAAAAAAAAAAAAAAAAAAAAAAAAAAAAAAAAAAAABQAAAAAAAAAwMD/AAAAAABkAAAAMgAAAAAAAABkAAAAAAAAAH9/fwAKAAAAIgAAABgAAAAAAAAAAAAAAAAAAAAAAAAAAAAAAAAAAAAkAAAAJAAAAAAAAAAHAAAAAAAAAAAAAAAAAAAAAAAAAAAAAAAAAAAAf39/ACUAAABYAAAAAAAAAAAAAAAAAAAAAAAAAAAAAAAAAAAAAAAAAAAAAAAAAAAAAAAAAAAAAAA/AAAAAAAAAKCGAQAAAAAAAAAAAAAAAAAMAAAAAQAAAAAAAAAAAAAAAAAAAB8AAABUAAAAQoX0Bf///wEAAAAAAAAAAAAAAAAAAAAAAAAAAAAAAAAAAAAAAAAAAAAAAAJ/f38AWVlZA8zMzADAwP8Af39/AAAAAAAAAAAAAAAAAAAAAAAAAAAAIQAAABgAAAAUAAAA4gUAAEADAABiNAAAziQAABAAAAAmAAAACAAAAD0wAAAAAAAA"/>
               </a:ext>
             </a:extLst>
           </p:cNvSpPr>
@@ -10350,7 +10208,7 @@
           <p:cNvSpPr>
             <a:extLst>
               <a:ext uri="smNativeData">
-                <pr:smNativeData xmlns:pr="smNativeData" xmlns="smNativeData" val="SMDATA_15_9kV5ZhMAAAAlAAAAZAAAAA0AAAAAkAAAAJAAAACQAAAAkAAAAAAAAAABAAAAAAAAAAEAAABQAAAAAAAAAAAA4D8AAAAAAADgPwAAAAAAAOA/AAAAAAAA4D8AAAAAAADgPwAAAAAAAOA/AAAAAAAA4D8AAAAAAADgPwAAAAAAAOA/AAAAAAAA4D8CAAAAjAAAAAAAAAAAAAAAQoX0DP///wgAAAAAAAAAAAAAAAAAAAAAAAAAAAAAAAAAAAAAZAAAAAEAAABAAAAAAAAAAAAAAAAAAAAAAAAAAAAAAAAAAAAAAAAAAAAAAAAAAAAAAAAAAAAAAAAAAAAAAAAAAAAAAAAAAAAAAAAAAAAAAAAAAAAAAAAAAAAAAAAAAAAAFAAAADwAAAAAAAAAAAAAAAAAAAkUAAAAAQAAABQAAAAUAAAAFAAAAAEAAAAAAAAAZAAAAGQAAAAAAAAAZAAAAGQAAAAVAAAAYAAAAAAAAAAAAAAADwAAACADAAAAAAAAAAAAAAEAAACgMgAAVgcAAKr4//8BAAAAf39/AAEAAABkAAAAAAAAABQAAABAHwAAAAAAACYAAAAAAAAAwOD//wAAAAAmAAAAZAAAABYAAABMAAAAAAAAAAAAAAAEAAAAAAAAAAEAAABZWVkKAAAAACgAAAAoAAAAZAAAAGQAAAAAAAAAzMzMAAAAAABQAAAAUAAAAGQAAABkAAAAAAAAABcAAAAUAAAAAAAAAAAAAAD/fwAA/38AAAAAAAAJAAAABAAAAF8AYAAeAAAAaAAAAAAAAAAAAAAAAAAAAAAAAAAAAAAAECcAABAnAAAAAAAAAAAAAAAAAAAAAAAAAAAAAAAAAAAAAAAAAAAAABQAAAAAAAAAwMD/AAAAAABkAAAAMgAAAAAAAABkAAAAAAAAAH9/fwAKAAAAIgAAABgAAAAAAAAAAAAAAAAAAAAAAAAAAAAAAAAAAAAkAAAAJAAAAAAAAAAHAAAAAAAAAAAAAAAAAAAAAAAAAAAAAAAAAAAAf39/ACUAAABYAAAAAAAAAAAAAAAAAAAAAAAAAAAAAAAAAAAAAAAAAAAAAAAAAAAAAAAAAAAAAAA/AAAAAAAAAKCGAQAAAAAAAAAAAAAAAAAMAAAAAQAAAAAAAAAAAAAAAAAAAB8AAABUAAAAQoX0Bf///wEAAAAAAAAAAAAAAAAAAAAAAAAAAAAAAAAAAAAAAAAAAAAAAAJ/f38AWVlZA8zMzADAwP8Af39/AAAAAAAAAAAAAAAAAAAAAAAAAAAAIQAAABgAAAAUAAAAtwQAAMgQAACINQAAsBcAABAAAAAmAAAACAAAAP//////////"/>
+                <pr:smNativeData xmlns:pr="smNativeData" xmlns="smNativeData" val="SMDATA_15_bQt8ZhMAAAAlAAAAZAAAAA0AAAAAkAAAAJAAAACQAAAAkAAAAAAAAAABAAAAAAAAAAEAAABQAAAAAAAAAAAA4D8AAAAAAADgPwAAAAAAAOA/AAAAAAAA4D8AAAAAAADgPwAAAAAAAOA/AAAAAAAA4D8AAAAAAADgPwAAAAAAAOA/AAAAAAAA4D8CAAAAjAAAAAAAAAAAAAAAQoX0DP///wgAAAAAAAAAAAAAAAAAAAAAAAAAAAAAAAAAAAAAZAAAAAEAAABAAAAAAAAAAAAAAAAAAAAAAAAAAAAAAAAAAAAAAAAAAAAAAAAAAAAAAAAAAAAAAAAAAAAAAAAAAAAAAAAAAAAAAAAAAAAAAAAAAAAAAAAAAAAAAAAAAAAAFAAAADwAAAAAAAAAAAAAAAAAAAkUAAAAAQAAABQAAAAUAAAAFAAAAAEAAAAAAAAAZAAAAGQAAAAAAAAAZAAAAGQAAAAVAAAAYAAAAAAAAAAAAAAADwAAACADAAAAAAAAAAAAAAEAAACgMgAAVgcAAKr4//8BAAAAf39/AAEAAABkAAAAAAAAABQAAABAHwAAAAAAACYAAAAAAAAAwOD//wAAAAAmAAAAZAAAABYAAABMAAAAAAAAAAAAAAAEAAAAAAAAAAEAAABZWVkKAAAAACgAAAAoAAAAZAAAAGQAAAAAAAAAzMzMAAAAAABQAAAAUAAAAGQAAABkAAAAAAAAABcAAAAUAAAAAAAAAAAAAAD/fwAA/38AAAAAAAAJAAAABAAAAF8AYAAeAAAAaAAAAAAAAAAAAAAAAAAAAAAAAAAAAAAAECcAABAnAAAAAAAAAAAAAAAAAAAAAAAAAAAAAAAAAAAAAAAAAAAAABQAAAAAAAAAwMD/AAAAAABkAAAAMgAAAAAAAABkAAAAAAAAAH9/fwAKAAAAIgAAABgAAAAAAAAAAAAAAAAAAAAAAAAAAAAAAAAAAAAkAAAAJAAAAAAAAAAHAAAAAAAAAAAAAAAAAAAAAAAAAAAAAAAAAAAAf39/ACUAAABYAAAAAAAAAAAAAAAAAAAAAAAAAAAAAAAAAAAAAAAAAAAAAAAAAAAAAAAAAAAAAAA/AAAAAAAAAKCGAQAAAAAAAAAAAAAAAAAMAAAAAQAAAAAAAAAAAAAAAAAAAB8AAABUAAAAQoX0Bf///wEAAAAAAAAAAAAAAAAAAAAAAAAAAAAAAAAAAAAAAAAAAAAAAAJ/f38AWVlZA8zMzADAwP8Af39/AAAAAAAAAAAAAAAAAAAAAAAAAAAAIQAAABgAAAAUAAAAtwQAAMgQAACINQAAsBcAABAAAAAmAAAACAAAAP//////////"/>
               </a:ext>
             </a:extLst>
           </p:cNvSpPr>
@@ -10429,7 +10287,7 @@
           <p:cNvPicPr>
             <a:extLst>
               <a:ext uri="smNativeData">
-                <pr:smNativeData xmlns:pr="smNativeData" xmlns="smNativeData" val="SMDATA_17_9kV5ZhMAAAAlAAAAEQAAAA0AAAAAkAAAAEgAAACQAAAASAAAAAAAAAAAAAAAAAAAAAEAAABQAAAAAAAAAAAA4D8AAAAAAADgPwAAAAAAAOA/AAAAAAAA4D8AAAAAAADgPwAAAAAAAOA/AAAAAAAA4D8AAAAAAADgPwAAAAAAAOA/AAAAAAAA4D8CAAAAjAAAAAAAAAAAAAAAQoX0DP///wgAAAAAAAAAAAAAAAAAAAAAAAAAAAAAAAAAAAAAZAAAAAEAAABAAAAAAAAAAAAAAAAAAAAAAAAAAAAAAAAAAAAAAAAAAAAAAAAAAAAAAAAAAAAAAAAAAAAAAAAAAAAAAAAAAAAAAAAAAAAAAAAAAAAAAAAAAAAAAAAAAAAAFAAAADwAAAAAAAAAAAAAAAAAAAkUAAAAAQAAABQAAAAUAAAAFAAAAAEAAAAAAAAAZAAAAGQAAAAAAAAAZAAAAGQAAAAVAAAAYAAAAAAAAAAAAAAADwAAACADAAAAAAAAAAAAAAEAAACgMgAAVgcAAKr4//8BAAAAf39/AAEAAABkAAAAAAAAABQAAABAHwAAAAAAACYAAAAAAAAAwOD//wAAAAAmAAAAZAAAABYAAABMAAAAAAAAAAAAAAAEAAAAAAAAAAEAAABZWVkKAAAAACgAAAAoAAAAZAAAAGQAAAAAAAAAzMzMAAAAAABQAAAAUAAAAGQAAABkAAAAAAAAAAcAAAA4AAAAAAAAAAAAAAAAAAAA////AAAAAAAAAAAAAAAAAAAAAAAAAAAAAAAAAAAAAABkAAAAZAAAAAAAAAAjAAAABAAAAGQAAAAXAAAAFAAAAAAAAAAAAAAA/38AAP9/AAAAAAAACQAAAAQAAAAAAAAAHgAAAGgAAAAAAAAAAAAAAAAAAAAAAAAAAAAAABAnAAAQJwAAAAAAAAAAAAAAAAAAAAAAAAAAAAAAAAAAAAAAAAAAAAAUAAAAAAAAAMDA/wAAAAAAZAAAADIAAAAAAAAAZAAAAAAAAAB/f38ACgAAACIAAAAYAAAAAAAAAAAAAAAAAAAAAAAAAAAAAAAAAAAAJAAAACQAAAAAAAAABwAAAAAAAAAAAAAAAAAAAAAAAAAAAAAAAAAAAH9/fwAlAAAAWAAAAAAAAAAAAAAAAAAAAAAAAAAAAAAAAAAAAAAAAAAAAAAAAAAAAAAAAAAAAAAAPwAAAAAAAACghgEAAAAAAAAAAAAAAAAADAAAAAEAAAAAAAAAAAAAAAAAAAAfAAAAVAAAAEKF9AX///8BAAAAAAAAAAAAAAAAAAAAAAAAAAAAAAAAAAAAAAAAAAAAAAACf39/AFlZWQPMzMwAwMD/AH9/fwAAAAAAAAAAAAAAAAD///8AAAAAACEAAAAYAAAAFAAAAEYFAAD3GgAAmAkAAEkfAAAQAAAAJgAAAAgAAAD//////////w=="/>
+                <pr:smNativeData xmlns:pr="smNativeData" xmlns="smNativeData" val="SMDATA_17_bQt8ZhMAAAAlAAAAEQAAAA0AAAAAkAAAAEgAAACQAAAASAAAAAAAAAAAAAAAAAAAAAEAAABQAAAAAAAAAAAA4D8AAAAAAADgPwAAAAAAAOA/AAAAAAAA4D8AAAAAAADgPwAAAAAAAOA/AAAAAAAA4D8AAAAAAADgPwAAAAAAAOA/AAAAAAAA4D8CAAAAjAAAAAAAAAAAAAAAQoX0DP///wgAAAAAAAAAAAAAAAAAAAAAAAAAAAAAAAAAAAAAZAAAAAEAAABAAAAAAAAAAAAAAAAAAAAAAAAAAAAAAAAAAAAAAAAAAAAAAAAAAAAAAAAAAAAAAAAAAAAAAAAAAAAAAAAAAAAAAAAAAAAAAAAAAAAAAAAAAAAAAAAAAAAAFAAAADwAAAAAAAAAAAAAAAAAAAkUAAAAAQAAABQAAAAUAAAAFAAAAAEAAAAAAAAAZAAAAGQAAAAAAAAAZAAAAGQAAAAVAAAAYAAAAAAAAAAAAAAADwAAACADAAAAAAAAAAAAAAEAAACgMgAAVgcAAKr4//8BAAAAf39/AAEAAABkAAAAAAAAABQAAABAHwAAAAAAACYAAAAAAAAAwOD//wAAAAAmAAAAZAAAABYAAABMAAAAAAAAAAAAAAAEAAAAAAAAAAEAAABZWVkKAAAAACgAAAAoAAAAZAAAAGQAAAAAAAAAzMzMAAAAAABQAAAAUAAAAGQAAABkAAAAAAAAAAcAAAA4AAAAAAAAAAAAAAAAAAAA////AAAAAAAAAAAAAAAAAAAAAAAAAAAAAAAAAAAAAABkAAAAZAAAAAAAAAAjAAAABAAAAGQAAAAXAAAAFAAAAAAAAAAAAAAA/38AAP9/AAAAAAAACQAAAAQAAAAAAAAAHgAAAGgAAAAAAAAAAAAAAAAAAAAAAAAAAAAAABAnAAAQJwAAAAAAAAAAAAAAAAAAAAAAAAAAAAAAAAAAAAAAAAAAAAAUAAAAAAAAAMDA/wAAAAAAZAAAADIAAAAAAAAAZAAAAAAAAAB/f38ACgAAACIAAAAYAAAAAAAAAAAAAAAAAAAAAAAAAAAAAAAAAAAAJAAAACQAAAAAAAAABwAAAAAAAAAAAAAAAAAAAAAAAAAAAAAAAAAAAH9/fwAlAAAAWAAAAAAAAAAAAAAAAAAAAAAAAAAAAAAAAAAAAAAAAAAAAAAAAAAAAAAAAAAAAAAAPwAAAAAAAACghgEAAAAAAAAAAAAAAAAADAAAAAEAAAAAAAAAAAAAAAAAAAAfAAAAVAAAAEKF9AX///8BAAAAAAAAAAAAAAAAAAAAAAAAAAAAAAAAAAAAAAAAAAAAAAACf39/AFlZWQPMzMwAwMD/AH9/fwAAAAAAAAAAAAAAAAD///8AAAAAACEAAAAYAAAAFAAAAEYFAAD3GgAAmAkAAEkfAAAQAAAAJgAAAAgAAAD//////////w=="/>
               </a:ext>
             </a:extLst>
           </p:cNvPicPr>
@@ -10462,7 +10320,7 @@
           <p:cNvPicPr>
             <a:extLst>
               <a:ext uri="smNativeData">
-                <pr:smNativeData xmlns:pr="smNativeData" xmlns="smNativeData" val="SMDATA_17_9kV5ZhMAAAAlAAAAEQAAAA0AAAAAkAAAAEgAAACQAAAASAAAAAAAAAAAAAAAAAAAAAEAAABQAAAAAAAAAAAA4D8AAAAAAADgPwAAAAAAAOA/AAAAAAAA4D8AAAAAAADgPwAAAAAAAOA/AAAAAAAA4D8AAAAAAADgPwAAAAAAAOA/AAAAAAAA4D8CAAAAjAAAAAAAAAAAAAAAQoX0DP///wgAAAAAAAAAAAAAAAAAAAAAAAAAAAAAAAAAAAAAZAAAAAEAAABAAAAAAAAAAAAAAAAAAAAAAAAAAAAAAAAAAAAAAAAAAAAAAAAAAAAAAAAAAAAAAAAAAAAAAAAAAAAAAAAAAAAAAAAAAAAAAAAAAAAAAAAAAAAAAAAAAAAAFAAAADwAAAAAAAAAAAAAAAAAAAkUAAAAAQAAABQAAAAUAAAAFAAAAAEAAAAAAAAAZAAAAGQAAAAAAAAAZAAAAGQAAAAVAAAAYAAAAAAAAAAAAAAADwAAACADAAAAAAAAAAAAAAEAAACgMgAAVgcAAKr4//8BAAAAf39/AAEAAABkAAAAAAAAABQAAABAHwAAAAAAACYAAAAAAAAAwOD//wAAAAAmAAAAZAAAABYAAABMAAAAAAAAAAAAAAAEAAAAAAAAAAEAAABZWVkKAAAAACgAAAAoAAAAZAAAAGQAAAAAAAAAzMzMAAAAAABQAAAAUAAAAGQAAABkAAAAAAAAAAcAAAA4AAAAAAAAAAAAAAAAAAAA////AAAAAAAAAAAAAAAAAAAAAAAAAAAAAAAAAAAAAABkAAAAZAAAAAAAAAAjAAAABAAAAGQAAAAXAAAAFAAAAAAAAAAAAAAA/38AAP9/AAAAAAAACQAAAAQAAADPAQAAHgAAAGgAAAAAAAAAAAAAAAAAAAAAAAAAAAAAABAnAAAQJwAAAAAAAAAAAAAAAAAAAAAAAAAAAAAAAAAAAAAAAAAAAAAUAAAAAAAAAMDA/wAAAAAAZAAAADIAAAAAAAAAZAAAAAAAAAB/f38ACgAAACIAAAAYAAAAAAAAAAAAAAAAAAAAAAAAAAAAAAAAAAAAJAAAACQAAAAAAAAABwAAAAAAAAAAAAAAAAAAAAAAAAAAAAAAAAAAAH9/fwAlAAAAWAAAAAAAAAAAAAAAAAAAAAAAAAAAAAAAAAAAAAAAAAAAAAAAAAAAAAAAAAAAAAAAPwAAAAAAAACghgEAAAAAAAAAAAAAAAAADAAAAAEAAAAAAAAAAAAAAAAAAAAfAAAAVAAAAEKF9AX///8BAAAAAAAAAAAAAAAAAAAAAAAAAAAAAAAAAAAAAAAAAAAAAAACf39/AFlZWQPMzMwAwMD/AH9/fwAAAAAAAAAAAAAAAAD///8AAAAAACEAAAAYAAAAFAAAALAKAAD3GgAAAg8AAEkfAAAQAAAAJgAAAAgAAAD//////////w=="/>
+                <pr:smNativeData xmlns:pr="smNativeData" xmlns="smNativeData" val="SMDATA_17_bQt8ZhMAAAAlAAAAEQAAAA0AAAAAkAAAAEgAAACQAAAASAAAAAAAAAAAAAAAAAAAAAEAAABQAAAAAAAAAAAA4D8AAAAAAADgPwAAAAAAAOA/AAAAAAAA4D8AAAAAAADgPwAAAAAAAOA/AAAAAAAA4D8AAAAAAADgPwAAAAAAAOA/AAAAAAAA4D8CAAAAjAAAAAAAAAAAAAAAQoX0DP///wgAAAAAAAAAAAAAAAAAAAAAAAAAAAAAAAAAAAAAZAAAAAEAAABAAAAAAAAAAAAAAAAAAAAAAAAAAAAAAAAAAAAAAAAAAAAAAAAAAAAAAAAAAAAAAAAAAAAAAAAAAAAAAAAAAAAAAAAAAAAAAAAAAAAAAAAAAAAAAAAAAAAAFAAAADwAAAAAAAAAAAAAAAAAAAkUAAAAAQAAABQAAAAUAAAAFAAAAAEAAAAAAAAAZAAAAGQAAAAAAAAAZAAAAGQAAAAVAAAAYAAAAAAAAAAAAAAADwAAACADAAAAAAAAAAAAAAEAAACgMgAAVgcAAKr4//8BAAAAf39/AAEAAABkAAAAAAAAABQAAABAHwAAAAAAACYAAAAAAAAAwOD//wAAAAAmAAAAZAAAABYAAABMAAAAAAAAAAAAAAAEAAAAAAAAAAEAAABZWVkKAAAAACgAAAAoAAAAZAAAAGQAAAAAAAAAzMzMAAAAAABQAAAAUAAAAGQAAABkAAAAAAAAAAcAAAA4AAAAAAAAAAAAAAAAAAAA////AAAAAAAAAAAAAAAAAAAAAAAAAAAAAAAAAAAAAABkAAAAZAAAAAAAAAAjAAAABAAAAGQAAAAXAAAAFAAAAAAAAAAAAAAA/38AAP9/AAAAAAAACQAAAAQAAADPAQAAHgAAAGgAAAAAAAAAAAAAAAAAAAAAAAAAAAAAABAnAAAQJwAAAAAAAAAAAAAAAAAAAAAAAAAAAAAAAAAAAAAAAAAAAAAUAAAAAAAAAMDA/wAAAAAAZAAAADIAAAAAAAAAZAAAAAAAAAB/f38ACgAAACIAAAAYAAAAAAAAAAAAAAAAAAAAAAAAAAAAAAAAAAAAJAAAACQAAAAAAAAABwAAAAAAAAAAAAAAAAAAAAAAAAAAAAAAAAAAAH9/fwAlAAAAWAAAAAAAAAAAAAAAAAAAAAAAAAAAAAAAAAAAAAAAAAAAAAAAAAAAAAAAAAAAAAAAPwAAAAAAAACghgEAAAAAAAAAAAAAAAAADAAAAAEAAAAAAAAAAAAAAAAAAAAfAAAAVAAAAEKF9AX///8BAAAAAAAAAAAAAAAAAAAAAAAAAAAAAAAAAAAAAAAAAAAAAAACf39/AFlZWQPMzMwAwMD/AH9/fwAAAAAAAAAAAAAAAAD///8AAAAAACEAAAAYAAAAFAAAALAKAAD3GgAAAg8AAEkfAAAQAAAAJgAAAAgAAAD//////////w=="/>
               </a:ext>
             </a:extLst>
           </p:cNvPicPr>
@@ -10527,7 +10385,7 @@
           <p:cNvSpPr>
             <a:extLst>
               <a:ext uri="smNativeData">
-                <pr:smNativeData xmlns:pr="smNativeData" xmlns="smNativeData" val="SMDATA_15_9kV5ZhMAAAAlAAAAZAAAAA0AAAAAkAAAAJAAAACQAAAAkAAAAAAAAAABAAAAAAAAAAEAAABQAAAAAAAAAAAA4D8AAAAAAADgPwAAAAAAAOA/AAAAAAAA4D8AAAAAAADgPwAAAAAAAOA/AAAAAAAA4D8AAAAAAADgPwAAAAAAAOA/AAAAAAAA4D8CAAAAjAAAAAEAAAAAAAAAAT2FAP///wgAAAAAAAAAAAAAAAAAAAAAAAAAAAAAAAAAAAAAeAAAAAEAAABAAAAAAAAAAAAAAABaAAAAAAAAAAAAAAAAAAAAAAAAAAAAAAAAAAAAAAAAAAAAAAAAAAAAAAAAAAAAAAAAAAAAAAAAAAAAAAAAAAAAAAAAAAAAAAAAAAAAFAAAADwAAAAAAAAAAAAAAAAAAAkUAAAAAQAAABQAAAAUAAAAFAAAAAEAAAAAAAAAZAAAAGQAAAAAAAAAZAAAAGQAAAAVAAAAYAAAAAAAAAAAAAAADwAAACADAAAAAAAAAAAAAAEAAACgMgAAVgcAAKr4//8BAAAAf39/AAEAAABkAAAAAAAAABQAAABAHwAAAAAAACYAAAAAAAAAwOD//wAAAAAmAAAAZAAAABYAAABMAAAAAAAAAAAAAAAEAAAAAAAAAAEAAABZWVkKAAAAACgAAAAoAAAAZAAAAGQAAAAAAAAAzMzMAAAAAABQAAAAUAAAAGQAAABkAAAAAAAAABcAAAAUAAAAAAAAAAAAAAD/fwAA/38AAAAAAAAJAAAABAAAAF8AYAAeAAAAaAAAAAAAAAAAAAAAAAAAAAAAAAAAAAAAECcAABAnAAAAAAAAAAAAAAAAAAAAAAAAAAAAAAAAAAAAAAAAAAAAABQAAAAAAAAAwMD/AAAAAABkAAAAMgAAAAAAAABkAAAAAAAAAH9/fwAKAAAAIgAAABgAAAAAAAAAAAAAAAAAAAAAAAAAAAAAAAAAAAAkAAAAJAAAAAAAAAAHAAAAAAAAAAAAAAAAAAAAAAAAAAAAAAAAAAAAf39/ACUAAABYAAAAAAAAAAAAAAAAAAAAAAAAAAAAAAAAAAAAAAAAAAAAAAAAAAAAAAAAAAAAAAA/AAAAAAAAAKCGAQAAAAAAAAAAAAAAAAAMAAAAAQAAAAAAAAAAAAAAAAAAAB8AAABUAAAAAT2FAP///wEAAAAAAAAAAAAAAAAAAAAAAAAAAAAAAAAAAAAAAAAAAAAAAAJ/f38AWVlZA8zMzADAwP8Af39/AAAAAAAAAAAAAAAAAAAAAAAAAAAAIQAAABgAAAAUAAAA4AMAAHUYAAAyDQAAniUAABAAAAAmAAAACAAAAP//////////"/>
+                <pr:smNativeData xmlns:pr="smNativeData" xmlns="smNativeData" val="SMDATA_15_bQt8ZhMAAAAlAAAAZAAAAA0AAAAAkAAAAJAAAACQAAAAkAAAAAAAAAABAAAAAAAAAAEAAABQAAAAAAAAAAAA4D8AAAAAAADgPwAAAAAAAOA/AAAAAAAA4D8AAAAAAADgPwAAAAAAAOA/AAAAAAAA4D8AAAAAAADgPwAAAAAAAOA/AAAAAAAA4D8CAAAAjAAAAAEAAAAAAAAAAT2FAP///wgAAAAAAAAAAAAAAAAAAAAAAAAAAAAAAAAAAAAAeAAAAAEAAABAAAAAAAAAAAAAAABaAAAAAAAAAAAAAAAAAAAAAAAAAAAAAAAAAAAAAAAAAAAAAAAAAAAAAAAAAAAAAAAAAAAAAAAAAAAAAAAAAAAAAAAAAAAAAAAAAAAAFAAAADwAAAAAAAAAAAAAAAAAAAkUAAAAAQAAABQAAAAUAAAAFAAAAAEAAAAAAAAAZAAAAGQAAAAAAAAAZAAAAGQAAAAVAAAAYAAAAAAAAAAAAAAADwAAACADAAAAAAAAAAAAAAEAAACgMgAAVgcAAKr4//8BAAAAf39/AAEAAABkAAAAAAAAABQAAABAHwAAAAAAACYAAAAAAAAAwOD//wAAAAAmAAAAZAAAABYAAABMAAAAAAAAAAAAAAAEAAAAAAAAAAEAAABZWVkKAAAAACgAAAAoAAAAZAAAAGQAAAAAAAAAzMzMAAAAAABQAAAAUAAAAGQAAABkAAAAAAAAABcAAAAUAAAAAAAAAAAAAAD/fwAA/38AAAAAAAAJAAAABAAAAF8AYAAeAAAAaAAAAAAAAAAAAAAAAAAAAAAAAAAAAAAAECcAABAnAAAAAAAAAAAAAAAAAAAAAAAAAAAAAAAAAAAAAAAAAAAAABQAAAAAAAAAwMD/AAAAAABkAAAAMgAAAAAAAABkAAAAAAAAAH9/fwAKAAAAIgAAABgAAAAAAAAAAAAAAAAAAAAAAAAAAAAAAAAAAAAkAAAAJAAAAAAAAAAHAAAAAAAAAAAAAAAAAAAAAAAAAAAAAAAAAAAAf39/ACUAAABYAAAAAAAAAAAAAAAAAAAAAAAAAAAAAAAAAAAAAAAAAAAAAAAAAAAAAAAAAAAAAAA/AAAAAAAAAKCGAQAAAAAAAAAAAAAAAAAMAAAAAQAAAAAAAAAAAAAAAAAAAB8AAABUAAAAAT2FAP///wEAAAAAAAAAAAAAAAAAAAAAAAAAAAAAAAAAAAAAAAAAAAAAAAJ/f38AWVlZA8zMzADAwP8Af39/AAAAAAAAAAAAAAAAAAAAAAAAAAAAIQAAABgAAAAUAAAA4AMAAHUYAAAyDQAAniUAABAAAAAmAAAACAAAAP//////////"/>
               </a:ext>
             </a:extLst>
           </p:cNvSpPr>
@@ -10572,7 +10430,7 @@
             <a:spLocks noGrp="1" noChangeArrowheads="1"/>
             <a:extLst>
               <a:ext uri="smNativeData">
-                <pr:smNativeData xmlns:pr="smNativeData" xmlns="smNativeData" val="SMDATA_15_9kV5ZhMAAAAlAAAAZAAAAA0AAAAAkAAAAJAAAACQAAAAkAAAAAAAAAAAAAAAAAAAAAEAAABQAAAAAAAAAAAA4D8AAAAAAADgPwAAAAAAAOA/AAAAAAAA4D8AAAAAAADgPwAAAAAAAOA/AAAAAAAA4D8AAAAAAADgPwAAAAAAAOA/AAAAAAAA4D8CAAAAjAAAAAAAAAAAAAAAQoX0DP///wgAAAAAAAAAAAAAAAAAAAAAAAAAAAAAAAAAAAAAZAAAAAEAAABAAAAAAAAAAAAAAAAAAAAAAAAAAAAAAAAAAAAAAAAAAAAAAAAAAAAAAAAAAAAAAAAAAAAAAAAAAAAAAAAAAAAAAAAAAAAAAAAAAAAAAAAAAAAAAAAAAAAAFAAAADwAAAAAAAAAAAAAAAAAAAkUAAAAAQAAABQAAAAUAAAAFAAAAAEAAAAAAAAAZAAAAGQAAAAAAAAAZAAAAGQAAAAVAAAAYAAAAAAAAAAAAAAADwAAACADAAAAAAAAAAAAAAEAAACgMgAAVgcAAKr4//8BAAAAf39/AAEAAABkAAAAAAAAABQAAABAHwAAAAAAACYAAAAAAAAAwOD//wAAAAAmAAAAZAAAABYAAABMAAAAAAAAAAAAAAAEAAAAAAAAAAEAAABZWVkKAAAAACgAAAAoAAAAZAAAAGQAAAAAAAAAzMzMAAAAAABQAAAAUAAAAGQAAABkAAAAAAAAABcAAAAUAAAAAAAAAAAAAAD/fwAA/38AAAAAAAAJAAAABAAAAJrHIpceAAAAaAAAAAAAAAAAAAAAAAAAAAAAAAAAAAAAECcAABAnAAAAAAAAAAAAAAAAAAAAAAAAAAAAAAAAAAAAAAAAAAAAABQAAAAAAAAAwMD/AAAAAABkAAAAMgAAAAAAAABkAAAAAAAAAH9/fwAKAAAAIgAAABgAAAAAAAAAAAAAAAAAAAAAAAAAAAAAAAAAAAAkAAAAJAAAAAAAAAAHAAAAAAAAAAAAAAAAAAAAAAAAAAAAAAAAAAAAf39/ACUAAABYAAAAAAAAAAAAAAAAAAAAAAAAAAAAAAAAAAAAAAAAAAAAAAAAAAAAAAAAAAAAAAA/AAAAAAAAAKCGAQAAAAAAAAAAAAAAAAAMAAAAAQAAAAAAAAAAAAAAAAAAAB8AAABUAAAAQoX0Bf///wEAAAAAAAAAAAAAAAAAAAAAAAAAAAAAAAAAAAAAAAAAAAAAAAJ/f38AWVlZA8zMzADAwP8Af39/AAAAAAAAAAAAAAAAAAAAAAAAAAAAIQAAABgAAAAUAAAAFAMAAM0AAAB/NwAAghAAABAAAAAmAAAACAAAAD0wAAAAAAAA"/>
+                <pr:smNativeData xmlns:pr="smNativeData" xmlns="smNativeData" val="SMDATA_15_bQt8ZhMAAAAlAAAAZAAAAA0AAAAAkAAAAJAAAACQAAAAkAAAAAAAAAAAAAAAAAAAAAEAAABQAAAAAAAAAAAA4D8AAAAAAADgPwAAAAAAAOA/AAAAAAAA4D8AAAAAAADgPwAAAAAAAOA/AAAAAAAA4D8AAAAAAADgPwAAAAAAAOA/AAAAAAAA4D8CAAAAjAAAAAAAAAAAAAAAQoX0DP///wgAAAAAAAAAAAAAAAAAAAAAAAAAAAAAAAAAAAAAZAAAAAEAAABAAAAAAAAAAAAAAAAAAAAAAAAAAAAAAAAAAAAAAAAAAAAAAAAAAAAAAAAAAAAAAAAAAAAAAAAAAAAAAAAAAAAAAAAAAAAAAAAAAAAAAAAAAAAAAAAAAAAAFAAAADwAAAAAAAAAAAAAAAAAAAkUAAAAAQAAABQAAAAUAAAAFAAAAAEAAAAAAAAAZAAAAGQAAAAAAAAAZAAAAGQAAAAVAAAAYAAAAAAAAAAAAAAADwAAACADAAAAAAAAAAAAAAEAAACgMgAAVgcAAKr4//8BAAAAf39/AAEAAABkAAAAAAAAABQAAABAHwAAAAAAACYAAAAAAAAAwOD//wAAAAAmAAAAZAAAABYAAABMAAAAAAAAAAAAAAAEAAAAAAAAAAEAAABZWVkKAAAAACgAAAAoAAAAZAAAAGQAAAAAAAAAzMzMAAAAAABQAAAAUAAAAGQAAABkAAAAAAAAABcAAAAUAAAAAAAAAAAAAAD/fwAA/38AAAAAAAAJAAAABAAAAJrHIpceAAAAaAAAAAAAAAAAAAAAAAAAAAAAAAAAAAAAECcAABAnAAAAAAAAAAAAAAAAAAAAAAAAAAAAAAAAAAAAAAAAAAAAABQAAAAAAAAAwMD/AAAAAABkAAAAMgAAAAAAAABkAAAAAAAAAH9/fwAKAAAAIgAAABgAAAAAAAAAAAAAAAAAAAAAAAAAAAAAAAAAAAAkAAAAJAAAAAAAAAAHAAAAAAAAAAAAAAAAAAAAAAAAAAAAAAAAAAAAf39/ACUAAABYAAAAAAAAAAAAAAAAAAAAAAAAAAAAAAAAAAAAAAAAAAAAAAAAAAAAAAAAAAAAAAA/AAAAAAAAAKCGAQAAAAAAAAAAAAAAAAAMAAAAAQAAAAAAAAAAAAAAAAAAAB8AAABUAAAAQoX0Bf///wEAAAAAAAAAAAAAAAAAAAAAAAAAAAAAAAAAAAAAAAAAAAAAAAJ/f38AWVlZA8zMzADAwP8Af39/AAAAAAAAAAAAAAAAAAAAAAAAAAAAIQAAABgAAAAUAAAAFAMAAM0AAAB/NwAAghAAABAAAAAmAAAACAAAAD0wAAAAAAAA"/>
               </a:ext>
             </a:extLst>
           </p:cNvSpPr>
@@ -10657,7 +10515,7 @@
             <a:spLocks noGrp="1" noChangeArrowheads="1"/>
             <a:extLst>
               <a:ext uri="smNativeData">
-                <pr:smNativeData xmlns:pr="smNativeData" xmlns="smNativeData" val="SMDATA_15_9kV5ZhMAAAAlAAAAZAAAAA0AAAAAkAAAAJAAAACQAAAAkAAAAAAAAAAAAAAAAAAAAAEAAABQAAAAAAAAAAAA4D8AAAAAAADgPwAAAAAAAOA/AAAAAAAA4D8AAAAAAADgPwAAAAAAAOA/AAAAAAAA4D8AAAAAAADgPwAAAAAAAOA/AAAAAAAA4D8CAAAAjAAAAAAAAAAAAAAAQoX0DP///wgAAAAAAAAAAAAAAAAAAAAAAAAAAAAAAAAAAAAAZAAAAAEAAABAAAAAAAAAAAAAAAAAAAAAAAAAAAAAAAAAAAAAAAAAAAAAAAAAAAAAAAAAAAAAAAAAAAAAAAAAAAAAAAAAAAAAAAAAAAAAAAAAAAAAAAAAAAAAAAAAAAAAFAAAADwAAAAAAAAAAAAAAAAAAAkUAAAAAQAAABQAAAAUAAAAFAAAAAEAAAAAAAAAZAAAAGQAAAAAAAAAZAAAAGQAAAAVAAAAYAAAAAAAAAAAAAAADwAAACADAAAAAAAAAAAAAAEAAACgMgAAVgcAAKr4//8BAAAAf39/AAEAAABkAAAAAAAAABQAAABAHwAAAAAAACYAAAAAAAAAwOD//wAAAAAmAAAAZAAAABYAAABMAAAAAAAAAAAAAAAEAAAAAAAAAAEAAABZWVkKAAAAACgAAAAoAAAAZAAAAGQAAAAAAAAAzMzMAAAAAABQAAAAUAAAAGQAAABkAAAAAAAAABcAAAAUAAAAAAAAAAAAAAD/fwAA/38AAAAAAAAJAAAABAAAAMgN8V0eAAAAaAAAAAAAAAAAAAAAAAAAAAAAAAAAAAAAECcAABAnAAAAAAAAAAAAAAAAAAAAAAAAAAAAAAAAAAAAAAAAAAAAABQAAAAAAAAAwMD/AAAAAABkAAAAMgAAAAAAAABkAAAAAAAAAH9/fwAKAAAAIgAAABgAAAAAAAAAAAAAAAAAAAAAAAAAAAAAAAAAAAAkAAAAJAAAAAAAAAAHAAAAAAAAAAAAAAAAAAAAAAAAAAAAAAAAAAAAf39/ACUAAABYAAAAAAAAAAAAAAAAAAAAAAAAAAAAAAAAAAAAAAAAAAAAAAAAAAAAAAAAAAAAAAA/AAAAAAAAAKCGAQAAAAAAAAAAAAAAAAAMAAAAAQAAAAAAAAAAAAAAAAAAAB8AAABUAAAAQoX0Bf///wEAAAAAAAAAAAAAAAAAAAAAAAAAAAAAAAAAAAAAAAAAAAAAAAJ/f38AWVlZA8zMzADAwP8Af39/AAAAAAAAAAAAAAAAAAAAAAAAAAAAIQAAABgAAAAUAAAAShMAAK8ZAABQNwAAgB4AABAAAAAmAAAACAAAAD2wAAAAAAAA"/>
+                <pr:smNativeData xmlns:pr="smNativeData" xmlns="smNativeData" val="SMDATA_15_bQt8ZhMAAAAlAAAAZAAAAA0AAAAAkAAAAJAAAACQAAAAkAAAAAAAAAAAAAAAAAAAAAEAAABQAAAAAAAAAAAA4D8AAAAAAADgPwAAAAAAAOA/AAAAAAAA4D8AAAAAAADgPwAAAAAAAOA/AAAAAAAA4D8AAAAAAADgPwAAAAAAAOA/AAAAAAAA4D8CAAAAjAAAAAAAAAAAAAAAQoX0DP///wgAAAAAAAAAAAAAAAAAAAAAAAAAAAAAAAAAAAAAZAAAAAEAAABAAAAAAAAAAAAAAAAAAAAAAAAAAAAAAAAAAAAAAAAAAAAAAAAAAAAAAAAAAAAAAAAAAAAAAAAAAAAAAAAAAAAAAAAAAAAAAAAAAAAAAAAAAAAAAAAAAAAAFAAAADwAAAAAAAAAAAAAAAAAAAkUAAAAAQAAABQAAAAUAAAAFAAAAAEAAAAAAAAAZAAAAGQAAAAAAAAAZAAAAGQAAAAVAAAAYAAAAAAAAAAAAAAADwAAACADAAAAAAAAAAAAAAEAAACgMgAAVgcAAKr4//8BAAAAf39/AAEAAABkAAAAAAAAABQAAABAHwAAAAAAACYAAAAAAAAAwOD//wAAAAAmAAAAZAAAABYAAABMAAAAAAAAAAAAAAAEAAAAAAAAAAEAAABZWVkKAAAAACgAAAAoAAAAZAAAAGQAAAAAAAAAzMzMAAAAAABQAAAAUAAAAGQAAABkAAAAAAAAABcAAAAUAAAAAAAAAAAAAAD/fwAA/38AAAAAAAAJAAAABAAAAMgN8V0eAAAAaAAAAAAAAAAAAAAAAAAAAAAAAAAAAAAAECcAABAnAAAAAAAAAAAAAAAAAAAAAAAAAAAAAAAAAAAAAAAAAAAAABQAAAAAAAAAwMD/AAAAAABkAAAAMgAAAAAAAABkAAAAAAAAAH9/fwAKAAAAIgAAABgAAAAAAAAAAAAAAAAAAAAAAAAAAAAAAAAAAAAkAAAAJAAAAAAAAAAHAAAAAAAAAAAAAAAAAAAAAAAAAAAAAAAAAAAAf39/ACUAAABYAAAAAAAAAAAAAAAAAAAAAAAAAAAAAAAAAAAAAAAAAAAAAAAAAAAAAAAAAAAAAAA/AAAAAAAAAKCGAQAAAAAAAAAAAAAAAAAMAAAAAQAAAAAAAAAAAAAAAAAAAB8AAABUAAAAQoX0Bf///wEAAAAAAAAAAAAAAAAAAAAAAAAAAAAAAAAAAAAAAAAAAAAAAAJ/f38AWVlZA8zMzADAwP8Af39/AAAAAAAAAAAAAAAAAAAAAAAAAAAAIQAAABgAAAAUAAAAShMAAK8ZAABQNwAAgB4AABAAAAAmAAAACAAAAD2wAAAAAAAA"/>
               </a:ext>
             </a:extLst>
           </p:cNvSpPr>
@@ -10865,7 +10723,7 @@
             <a:spLocks noGrp="1" noChangeArrowheads="1"/>
             <a:extLst>
               <a:ext uri="smNativeData">
-                <pr:smNativeData xmlns:pr="smNativeData" xmlns="smNativeData" val="SMDATA_15_9kV5ZhMAAAAlAAAAZAAAAA0AAAAAkAAAAJAAAACQAAAAkAAAAAAAAAAAAAAAAAAAAAEAAABQAAAAAAAAAAAA4D8AAAAAAADgPwAAAAAAAOA/AAAAAAAA4D8AAAAAAADgPwAAAAAAAOA/AAAAAAAA4D8AAAAAAADgPwAAAAAAAOA/AAAAAAAA4D8CAAAAjAAAAAAAAAAAAAAAQoX0DP///wgAAAAAAAAAAAAAAAAAAAAAAAAAAAAAAAAAAAAAZAAAAAEAAABAAAAAAAAAAAAAAAAAAAAAAAAAAAAAAAAAAAAAAAAAAAAAAAAAAAAAAAAAAAAAAAAAAAAAAAAAAAAAAAAAAAAAAAAAAAAAAAAAAAAAAAAAAAAAAAAAAAAAFAAAADwAAAAAAAAAAAAAAAAAAAkUAAAAAQAAABQAAAAUAAAAFAAAAAEAAAAAAAAAZAAAAGQAAAAAAAAAZAAAAGQAAAAVAAAAYAAAAAAAAAAAAAAADwAAACADAAAAAAAAAAAAAAEAAACgMgAAVgcAAKr4//8BAAAAf39/AAEAAABkAAAAAAAAABQAAABAHwAAAAAAACYAAAAAAAAAwOD//wAAAAAmAAAAZAAAABYAAABMAAAAAAAAAAAAAAAEAAAAAAAAAAEAAABZWVkKAAAAACgAAAAoAAAAZAAAAGQAAAAAAAAAzMzMAAAAAABQAAAAUAAAAGQAAABkAAAAAAAAABcAAAAUAAAAAAAAAAAAAAD/fwAA/38AAAAAAAAJAAAABAAAAIscKB0eAAAAaAAAAAAAAAAAAAAAAAAAAAAAAAAAAAAAECcAABAnAAAAAAAAAAAAAAAAAAAAAAAAAAAAAAAAAAAAAAAAAAAAABQAAAAAAAAAwMD/AAAAAABkAAAAMgAAAAAAAABkAAAAAAAAAH9/fwAKAAAAIgAAABgAAAAAAAAAAAAAAAAAAAAAAAAAAAAAAAAAAAAkAAAAJAAAAAAAAAAHAAAAAAAAAAAAAAAAAAAAAAAAAAAAAAAAAAAAf39/ACUAAABYAAAAAAAAAAAAAAAAAAAAAAAAAAAAAAAAAAAAAAAAAAAAAAAAAAAAAAAAAAAAAAA/AAAAAAAAAKCGAQAAAAAAAAAAAAAAAAAMAAAAAQAAAAAAAAAAAAAAAAAAAB8AAABUAAAAQoX0Bf///wEAAAAAAAAAAAAAAAAAAAAAAAAAAAAAAAAAAAAAAAAAAAAAAAJ/f38AWVlZA8zMzADAwP8Af39/AAAAAAAAAAAAAAAAAAAAAAAAAAAAIQAAABgAAAAUAAAAShMAACUcAABQNwAApSIAABAAAAAmAAAACAAAAD0wAAAAAAAA"/>
+                <pr:smNativeData xmlns:pr="smNativeData" xmlns="smNativeData" val="SMDATA_15_bQt8ZhMAAAAlAAAAZAAAAA0AAAAAkAAAAJAAAACQAAAAkAAAAAAAAAAAAAAAAAAAAAEAAABQAAAAAAAAAAAA4D8AAAAAAADgPwAAAAAAAOA/AAAAAAAA4D8AAAAAAADgPwAAAAAAAOA/AAAAAAAA4D8AAAAAAADgPwAAAAAAAOA/AAAAAAAA4D8CAAAAjAAAAAAAAAAAAAAAQoX0DP///wgAAAAAAAAAAAAAAAAAAAAAAAAAAAAAAAAAAAAAZAAAAAEAAABAAAAAAAAAAAAAAAAAAAAAAAAAAAAAAAAAAAAAAAAAAAAAAAAAAAAAAAAAAAAAAAAAAAAAAAAAAAAAAAAAAAAAAAAAAAAAAAAAAAAAAAAAAAAAAAAAAAAAFAAAADwAAAAAAAAAAAAAAAAAAAkUAAAAAQAAABQAAAAUAAAAFAAAAAEAAAAAAAAAZAAAAGQAAAAAAAAAZAAAAGQAAAAVAAAAYAAAAAAAAAAAAAAADwAAACADAAAAAAAAAAAAAAEAAACgMgAAVgcAAKr4//8BAAAAf39/AAEAAABkAAAAAAAAABQAAABAHwAAAAAAACYAAAAAAAAAwOD//wAAAAAmAAAAZAAAABYAAABMAAAAAAAAAAAAAAAEAAAAAAAAAAEAAABZWVkKAAAAACgAAAAoAAAAZAAAAGQAAAAAAAAAzMzMAAAAAABQAAAAUAAAAGQAAABkAAAAAAAAABcAAAAUAAAAAAAAAAAAAAD/fwAA/38AAAAAAAAJAAAABAAAAIscKB0eAAAAaAAAAAAAAAAAAAAAAAAAAAAAAAAAAAAAECcAABAnAAAAAAAAAAAAAAAAAAAAAAAAAAAAAAAAAAAAAAAAAAAAABQAAAAAAAAAwMD/AAAAAABkAAAAMgAAAAAAAABkAAAAAAAAAH9/fwAKAAAAIgAAABgAAAAAAAAAAAAAAAAAAAAAAAAAAAAAAAAAAAAkAAAAJAAAAAAAAAAHAAAAAAAAAAAAAAAAAAAAAAAAAAAAAAAAAAAAf39/ACUAAABYAAAAAAAAAAAAAAAAAAAAAAAAAAAAAAAAAAAAAAAAAAAAAAAAAAAAAAAAAAAAAAA/AAAAAAAAAKCGAQAAAAAAAAAAAAAAAAAMAAAAAQAAAAAAAAAAAAAAAAAAAB8AAABUAAAAQoX0Bf///wEAAAAAAAAAAAAAAAAAAAAAAAAAAAAAAAAAAAAAAAAAAAAAAAJ/f38AWVlZA8zMzADAwP8Af39/AAAAAAAAAAAAAAAAAAAAAAAAAAAAIQAAABgAAAAUAAAAShMAACUcAABQNwAApSIAABAAAAAmAAAACAAAAD0wAAAAAAAA"/>
               </a:ext>
             </a:extLst>
           </p:cNvSpPr>
@@ -10911,7 +10769,7 @@
             <a:spLocks noGrp="1" noChangeArrowheads="1"/>
             <a:extLst>
               <a:ext uri="smNativeData">
-                <pr:smNativeData xmlns:pr="smNativeData" xmlns="smNativeData" val="SMDATA_15_9kV5ZhMAAAAlAAAAZAAAAA0AAAAAkAAAAJAAAACQAAAAkAAAAAAAAAAAAAAAAAAAAAEAAABQAAAAAAAAAAAA4D8AAAAAAADgPwAAAAAAAOA/AAAAAAAA4D8AAAAAAADgPwAAAAAAAOA/AAAAAAAA4D8AAAAAAADgPwAAAAAAAOA/AAAAAAAA4D8CAAAAjAAAAAAAAAAAAAAAQoX0DP///wgAAAAAAAAAAAAAAAAAAAAAAAAAAAAAAAAAAAAAZAAAAAEAAABAAAAAAAAAAAAAAAAAAAAAAAAAAAAAAAAAAAAAAAAAAAAAAAAAAAAAAAAAAAAAAAAAAAAAAAAAAAAAAAAAAAAAAAAAAAAAAAAAAAAAAAAAAAAAAAAAAAAAFAAAADwAAAAAAAAAAAAAAAAAAAkUAAAAAQAAABQAAAAUAAAAFAAAAAEAAAAAAAAAZAAAAGQAAAAAAAAAZAAAAGQAAAAVAAAAYAAAAAAAAAAAAAAADwAAACADAAAAAAAAAAAAAAEAAACgMgAAVgcAAKr4//8BAAAAf39/AAEAAABkAAAAAAAAABQAAABAHwAAAAAAACYAAAAAAAAAwOD//wAAAAAmAAAAZAAAABYAAABMAAAAAAAAAAAAAAAEAAAAAAAAAAEAAABZWVkKAAAAACgAAAAoAAAAZAAAAGQAAAAAAAAAzMzMAAAAAABQAAAAUAAAAGQAAABkAAAAAAAAABcAAAAUAAAAAAAAAAAAAAD/fwAA/38AAAAAAAAJAAAABAAAAG28P2UeAAAAaAAAAAAAAAAAAAAAAAAAAAAAAAAAAAAAECcAABAnAAAAAAAAAAAAAAAAAAAAAAAAAAAAAAAAAAAAAAAAAAAAABQAAAAAAAAAwMD/AAAAAABkAAAAMgAAAAAAAABkAAAAAAAAAH9/fwAKAAAAIgAAABgAAAAAAAAAAAAAAAAAAAAAAAAAAAAAAAAAAAAkAAAAJAAAAAAAAAAHAAAAAAAAAAAAAAAAAAAAAAAAAAAAAAAAAAAAf39/ACUAAABYAAAAAAAAAAAAAAAAAAAAAAAAAAAAAAAAAAAAAAAAAAAAAAAAAAAAAAAAAAAAAAA/AAAAAAAAAKCGAQAAAAAAAAAAAAAAAAAMAAAAAQAAAAAAAAAAAAAAAAAAAB8AAABUAAAAQoX0Bf///wEAAAAAAAAAAAAAAAAAAAAAAAAAAAAAAAAAAAAAAAAAAAAAAAJ/f38AWVlZA8zMzADAwP8Af39/AAAAAAAAAAAAAAAAAAAAAAAAAAAAIQAAABgAAAAUAAAAShMAACUdAABQNwAAniUAABAAAAAmAAAACAAAAD0wAAAAAAAA"/>
+                <pr:smNativeData xmlns:pr="smNativeData" xmlns="smNativeData" val="SMDATA_15_bQt8ZhMAAAAlAAAAZAAAAA0AAAAAkAAAAJAAAACQAAAAkAAAAAAAAAAAAAAAAAAAAAEAAABQAAAAAAAAAAAA4D8AAAAAAADgPwAAAAAAAOA/AAAAAAAA4D8AAAAAAADgPwAAAAAAAOA/AAAAAAAA4D8AAAAAAADgPwAAAAAAAOA/AAAAAAAA4D8CAAAAjAAAAAAAAAAAAAAAQoX0DP///wgAAAAAAAAAAAAAAAAAAAAAAAAAAAAAAAAAAAAAZAAAAAEAAABAAAAAAAAAAAAAAAAAAAAAAAAAAAAAAAAAAAAAAAAAAAAAAAAAAAAAAAAAAAAAAAAAAAAAAAAAAAAAAAAAAAAAAAAAAAAAAAAAAAAAAAAAAAAAAAAAAAAAFAAAADwAAAAAAAAAAAAAAAAAAAkUAAAAAQAAABQAAAAUAAAAFAAAAAEAAAAAAAAAZAAAAGQAAAAAAAAAZAAAAGQAAAAVAAAAYAAAAAAAAAAAAAAADwAAACADAAAAAAAAAAAAAAEAAACgMgAAVgcAAKr4//8BAAAAf39/AAEAAABkAAAAAAAAABQAAABAHwAAAAAAACYAAAAAAAAAwOD//wAAAAAmAAAAZAAAABYAAABMAAAAAAAAAAAAAAAEAAAAAAAAAAEAAABZWVkKAAAAACgAAAAoAAAAZAAAAGQAAAAAAAAAzMzMAAAAAABQAAAAUAAAAGQAAABkAAAAAAAAABcAAAAUAAAAAAAAAAAAAAD/fwAA/38AAAAAAAAJAAAABAAAAG28P2UeAAAAaAAAAAAAAAAAAAAAAAAAAAAAAAAAAAAAECcAABAnAAAAAAAAAAAAAAAAAAAAAAAAAAAAAAAAAAAAAAAAAAAAABQAAAAAAAAAwMD/AAAAAABkAAAAMgAAAAAAAABkAAAAAAAAAH9/fwAKAAAAIgAAABgAAAAAAAAAAAAAAAAAAAAAAAAAAAAAAAAAAAAkAAAAJAAAAAAAAAAHAAAAAAAAAAAAAAAAAAAAAAAAAAAAAAAAAAAAf39/ACUAAABYAAAAAAAAAAAAAAAAAAAAAAAAAAAAAAAAAAAAAAAAAAAAAAAAAAAAAAAAAAAAAAA/AAAAAAAAAKCGAQAAAAAAAAAAAAAAAAAMAAAAAQAAAAAAAAAAAAAAAAAAAB8AAABUAAAAQoX0Bf///wEAAAAAAAAAAAAAAAAAAAAAAAAAAAAAAAAAAAAAAAAAAAAAAAJ/f38AWVlZA8zMzADAwP8Af39/AAAAAAAAAAAAAAAAAAAAAAAAAAAAIQAAABgAAAAUAAAAShMAACUdAABQNwAAniUAABAAAAAmAAAACAAAAD0wAAAAAAAA"/>
               </a:ext>
             </a:extLst>
           </p:cNvSpPr>
@@ -10979,7 +10837,7 @@
             <a:picLocks noChangeAspect="1"/>
             <a:extLst>
               <a:ext uri="smNativeData">
-                <pr:smNativeData xmlns:pr="smNativeData" xmlns="smNativeData" val="SMDATA_17_9kV5ZhMAAAAlAAAAEQAAAC8BAAAAkAAAAEgAAACQAAAASAAAAAAAAAAAAAAAAAAAAAEAAABQAAAAAAAAAAAA4D8AAAAAAADgPwAAAAAAAOA/AAAAAAAA4D8AAAAAAADgPwAAAAAAAOA/AAAAAAAA4D8AAAAAAADgPwAAAAAAAOA/AAAAAAAA4D8CAAAAjAAAAAAAAAAAAAAAQoX0DP///wgAAAAAAAAAAAAAAAAAAAAAAAAAAAAAAAAAAAAAZAAAAAEAAABAAAAAAAAAAAAAAAAAAAAAAAAAAAAAAAAAAAAAAAAAAAAAAAAAAAAAAAAAAAAAAAAAAAAAAAAAAAAAAAAAAAAAAAAAAAAAAAAAAAAAAAAAAAAAAAAAAAAAFAAAADwAAAAAAAAAAAAAAAAAAAkUAAAAAQAAABQAAAAUAAAAFAAAAAEAAAAAAAAAZAAAAGQAAAAAAAAAZAAAAGQAAAAVAAAAYAAAAAAAAAAAAAAADwAAACADAAAAAAAAAAAAAAEAAACgMgAAVgcAAKr4//8BAAAAf39/AAEAAABkAAAAAAAAABQAAABAHwAAAAAAACYAAAAAAAAAwOD//wAAAAAmAAAAZAAAABYAAABMAAAAAAAAAAAAAAAEAAAAAAAAAAEAAABZWVkKAAAAACgAAAAoAAAAZAAAAGQAAAAAAAAAzMzMAAAAAABQAAAAUAAAAGQAAABkAAAAAAAAAAcAAAA4AAAAAAAAAAAAAAAAAAAA////AAAAAAAAAAAAAAAAAAAAAAAAAAAAAAAAAAAAAABkAAAAZAAAAAAAAAAjAAAABAAAAGQAAAAXAAAAFAAAAAAAAAAAAAAA/38AAP9/AAAAAAAACQAAAAQAAAAAAAAAHgAAAGgAAAAAAAAAAAAAAAAAAAAAAAAAAAAAABAnAAAQJwAAAAAAAAAAAAAAAAAAAAAAAAAAAAAAAAAAAAAAAAAAAAAUAAAAAAAAAMDA/wAAAAAAZAAAADIAAAAAAAAAZAAAAAAAAAB/f38ACgAAACIAAAAYAAAAAAAAAAAAAAAAAAAAAAAAAAAAAAAAAAAAJAAAACQAAAAAAAAABwAAAAAAAAAAAAAAAAAAAAAAAAAAAAAAAAAAAH9/fwAlAAAAWAAAAAAAAAAAAAAAAAAAAAAAAAAAAAAAAAAAAAAAAAAAAAAAAAAAAAAAAAAAAAAAPwAAAAAAAACghgEAAAAAAAAAAAAAAAAADAAAAAEAAAAAAAAAAAAAAAAAAAAfAAAAVAAAAEKF9AX///8BAAAAAAAAAAAAAAAAAAAAAAAAAAAAAAAAAAAAAAAAAAAAAAACf39/AFlZWQPMzMwAwMD/AH9/fwAAAAAAAAAAAAAAAAD///8AAAAAACEAAAAYAAAAFAAAAHgEAACpGAAA0Q4AAL8lAAAQAAAAJgAAAAgAAAD//////////w=="/>
+                <pr:smNativeData xmlns:pr="smNativeData" xmlns="smNativeData" val="SMDATA_17_bQt8ZhMAAAAlAAAAEQAAAC8BAAAAkAAAAEgAAACQAAAASAAAAAAAAAAAAAAAAAAAAAEAAABQAAAAAAAAAAAA4D8AAAAAAADgPwAAAAAAAOA/AAAAAAAA4D8AAAAAAADgPwAAAAAAAOA/AAAAAAAA4D8AAAAAAADgPwAAAAAAAOA/AAAAAAAA4D8CAAAAjAAAAAAAAAAAAAAAQoX0DP///wgAAAAAAAAAAAAAAAAAAAAAAAAAAAAAAAAAAAAAZAAAAAEAAABAAAAAAAAAAAAAAAAAAAAAAAAAAAAAAAAAAAAAAAAAAAAAAAAAAAAAAAAAAAAAAAAAAAAAAAAAAAAAAAAAAAAAAAAAAAAAAAAAAAAAAAAAAAAAAAAAAAAAFAAAADwAAAAAAAAAAAAAAAAAAAkUAAAAAQAAABQAAAAUAAAAFAAAAAEAAAAAAAAAZAAAAGQAAAAAAAAAZAAAAGQAAAAVAAAAYAAAAAAAAAAAAAAADwAAACADAAAAAAAAAAAAAAEAAACgMgAAVgcAAKr4//8BAAAAf39/AAEAAABkAAAAAAAAABQAAABAHwAAAAAAACYAAAAAAAAAwOD//wAAAAAmAAAAZAAAABYAAABMAAAAAAAAAAAAAAAEAAAAAAAAAAEAAABZWVkKAAAAACgAAAAoAAAAZAAAAGQAAAAAAAAAzMzMAAAAAABQAAAAUAAAAGQAAABkAAAAAAAAAAcAAAA4AAAAAAAAAAAAAAAAAAAA////AAAAAAAAAAAAAAAAAAAAAAAAAAAAAAAAAAAAAABkAAAAZAAAAAAAAAAjAAAABAAAAGQAAAAXAAAAFAAAAAAAAAAAAAAA/38AAP9/AAAAAAAACQAAAAQAAAAAAAAAHgAAAGgAAAAAAAAAAAAAAAAAAAAAAAAAAAAAABAnAAAQJwAAAAAAAAAAAAAAAAAAAAAAAAAAAAAAAAAAAAAAAAAAAAAUAAAAAAAAAMDA/wAAAAAAZAAAADIAAAAAAAAAZAAAAAAAAAB/f38ACgAAACIAAAAYAAAAAAAAAAAAAAAAAAAAAAAAAAAAAAAAAAAAJAAAACQAAAAAAAAABwAAAAAAAAAAAAAAAAAAAAAAAAAAAAAAAAAAAH9/fwAlAAAAWAAAAAAAAAAAAAAAAAAAAAAAAAAAAAAAAAAAAAAAAAAAAAAAAAAAAAAAAAAAAAAAPwAAAAAAAACghgEAAAAAAAAAAAAAAAAADAAAAAEAAAAAAAAAAAAAAAAAAAAfAAAAVAAAAEKF9AX///8BAAAAAAAAAAAAAAAAAAAAAAAAAAAAAAAAAAAAAAAAAAAAAAACf39/AFlZWQPMzMwAwMD/AH9/fwAAAAAAAAAAAAAAAAD///8AAAAAACEAAAAYAAAAFAAAAHgEAACpGAAA0Q4AAL8lAAAQAAAAJgAAAAgAAAD//////////w=="/>
               </a:ext>
             </a:extLst>
           </p:cNvPicPr>
@@ -11045,7 +10903,7 @@
             <a:spLocks noGrp="1" noChangeArrowheads="1"/>
             <a:extLst>
               <a:ext uri="smNativeData">
-                <pr:smNativeData xmlns:pr="smNativeData" xmlns="smNativeData" val="SMDATA_15_9kV5ZhMAAAAlAAAAZAAAAA0AAAAAkAAAAJAAAACQAAAAkAAAAAAAAAAAAAAAAAAAAAEAAABQAAAAAAAAAAAA4D8AAAAAAADgPwAAAAAAAOA/AAAAAAAA4D8AAAAAAADgPwAAAAAAAOA/AAAAAAAA4D8AAAAAAADgPwAAAAAAAOA/AAAAAAAA4D8CAAAAjAAAAAAAAAAAAAAAQoX0DP///wgAAAAAAAAAAAAAAAAAAAAAAAAAAAAAAAAAAAAAZAAAAAEAAABAAAAAAAAAAAAAAAAAAAAAAAAAAAAAAAAAAAAAAAAAAAAAAAAAAAAAAAAAAAAAAAAAAAAAAAAAAAAAAAAAAAAAAAAAAAAAAAAAAAAAAAAAAAAAAAAAAAAAFAAAADwAAAAAAAAAAAAAAAAAAAkUAAAAAQAAABQAAAAUAAAAFAAAAAEAAAAAAAAAZAAAAGQAAAAAAAAAZAAAAGQAAAAVAAAAYAAAAAAAAAAAAAAADwAAACADAAAAAAAAAAAAAAEAAACgMgAAVgcAAKr4//8BAAAAf39/AAEAAABkAAAAAAAAABQAAABAHwAAAAAAACYAAAAAAAAAwOD//wAAAAAmAAAAZAAAABYAAABMAAAAAAAAAAAAAAAEAAAAAAAAAAEAAABZWVkKAAAAACgAAAAoAAAAZAAAAGQAAAAAAAAAzMzMAAAAAABQAAAAUAAAAGQAAABkAAAAAAAAABcAAAAUAAAAAAAAAAAAAAD/fwAA/38AAAAAAAAJAAAABAAAAF8AYAAeAAAAaAAAAAAAAAAAAAAAAAAAAAAAAAAAAAAAECcAABAnAAAAAAAAAAAAAAAAAAAAAAAAAAAAAAAAAAAAAAAAAAAAABQAAAAAAAAAwMD/AAAAAABkAAAAMgAAAAAAAABkAAAAAAAAAH9/fwAKAAAAIgAAABgAAAAAAAAAAAAAAAAAAAAAAAAAAAAAAAAAAAAkAAAAJAAAAAAAAAAHAAAAAAAAAAAAAAAAAAAAAAAAAAAAAAAAAAAAf39/ACUAAABYAAAAAAAAAAAAAAAAAAAAAAAAAAAAAAAAAAAAAAAAAAAAAAAAAAAAAAAAAAAAAAA/AAAAAAAAAKCGAQAAAAAAAAAAAAAAAAAMAAAAAQAAAAAAAAAAAAAAAAAAAB8AAABUAAAAAAAABQAAAAEAAAAAAAAAAAAAAAAAAAAAAAAAAAAAAAAAAAAAAAAAAAAAAAJ/f38AWVlZA8zMzADAwP8Af39/AAAAAAAAAAAAAAAAAAAAAAAAAAAAIQAAABgAAAAUAAAAFAMAALYCAAB/NwAAVAcAABAAAAAmAAAACAAAAD0wAAAAAAAA"/>
+                <pr:smNativeData xmlns:pr="smNativeData" xmlns="smNativeData" val="SMDATA_15_bQt8ZhMAAAAlAAAAZAAAAA0AAAAAkAAAAJAAAACQAAAAkAAAAAAAAAAAAAAAAAAAAAEAAABQAAAAAAAAAAAA4D8AAAAAAADgPwAAAAAAAOA/AAAAAAAA4D8AAAAAAADgPwAAAAAAAOA/AAAAAAAA4D8AAAAAAADgPwAAAAAAAOA/AAAAAAAA4D8CAAAAjAAAAAAAAAAAAAAAQoX0DP///wgAAAAAAAAAAAAAAAAAAAAAAAAAAAAAAAAAAAAAZAAAAAEAAABAAAAAAAAAAAAAAAAAAAAAAAAAAAAAAAAAAAAAAAAAAAAAAAAAAAAAAAAAAAAAAAAAAAAAAAAAAAAAAAAAAAAAAAAAAAAAAAAAAAAAAAAAAAAAAAAAAAAAFAAAADwAAAAAAAAAAAAAAAAAAAkUAAAAAQAAABQAAAAUAAAAFAAAAAEAAAAAAAAAZAAAAGQAAAAAAAAAZAAAAGQAAAAVAAAAYAAAAAAAAAAAAAAADwAAACADAAAAAAAAAAAAAAEAAACgMgAAVgcAAKr4//8BAAAAf39/AAEAAABkAAAAAAAAABQAAABAHwAAAAAAACYAAAAAAAAAwOD//wAAAAAmAAAAZAAAABYAAABMAAAAAAAAAAAAAAAEAAAAAAAAAAEAAABZWVkKAAAAACgAAAAoAAAAZAAAAGQAAAAAAAAAzMzMAAAAAABQAAAAUAAAAGQAAABkAAAAAAAAABcAAAAUAAAAAAAAAAAAAAD/fwAA/38AAAAAAAAJAAAABAAAAF8AYAAeAAAAaAAAAAAAAAAAAAAAAAAAAAAAAAAAAAAAECcAABAnAAAAAAAAAAAAAAAAAAAAAAAAAAAAAAAAAAAAAAAAAAAAABQAAAAAAAAAwMD/AAAAAABkAAAAMgAAAAAAAABkAAAAAAAAAH9/fwAKAAAAIgAAABgAAAAAAAAAAAAAAAAAAAAAAAAAAAAAAAAAAAAkAAAAJAAAAAAAAAAHAAAAAAAAAAAAAAAAAAAAAAAAAAAAAAAAAAAAf39/ACUAAABYAAAAAAAAAAAAAAAAAAAAAAAAAAAAAAAAAAAAAAAAAAAAAAAAAAAAAAAAAAAAAAA/AAAAAAAAAKCGAQAAAAAAAAAAAAAAAAAMAAAAAQAAAAAAAAAAAAAAAAAAAB8AAABUAAAAQoX0Bf///wEAAAAAAAAAAAAAAAAAAAAAAAAAAAAAAAAAAAAAAAAAAAAAAAJ/f38AWVlZA8zMzADAwP8Af39/AAAAAAAAAAAAAAAAAAAAAAAAAAAAIQAAABgAAAAUAAAAFAMAALYCAAB/NwAAVAcAABAAAAAmAAAACAAAAD0wAAAAAAAA"/>
               </a:ext>
             </a:extLst>
           </p:cNvSpPr>
@@ -11090,7 +10948,7 @@
           <p:cNvSpPr>
             <a:extLst>
               <a:ext uri="smNativeData">
-                <pr:smNativeData xmlns:pr="smNativeData" xmlns="smNativeData" val="SMDATA_15_9kV5ZhMAAAAlAAAAZQAAAA0AAAAAqQEAAJAAAACpAQAAkAAAAAAAAAABAAAAAAAAAAEAAABQAAAAhbacS3FV1T8AAAAAAAAAAAAAAAAAAOA/AAAAAAAA4D8AAAAAAADgPwAAAAAAAOA/AAAAAAAA4D8AAAAAAADgPwAAAAAAAOA/AAAAAAAA4D8CAAAAjAAAAAEAAAAAAAAAi47jAP///wgAAAAAAAAAAAAAAAAAAAAAAAAAAAAAAAAAAAAAeAAAAAEAAABAAAAAAAAAAAAAAABaAAAAAAAAAAAAAAAAAAAAAAAAAAAAAAAAAAAAAAAAAAAAAAAAAAAAAAAAAAAAAAAAAAAAAAAAAAAAAAAAAAAAAAAAAAAAAAAAAAAAFAAAADwAAAAAAAAAAAAAAAAAAAkUAAAAAQAAABQAAAAUAAAAFAAAAAEAAAAAAAAAZAAAAGQAAAAAAAAAZAAAAGQAAAAVAAAAYAAAAAAAAAAAAAAADwAAACADAAAAAAAAAAAAAAEAAACgMgAAVgcAAKr4//8BAAAAf39/AAEAAABkAAAAAAAAABQAAABAHwAAAAAAACYAAAAAAAAAwOD//wAAAAAmAAAAZAAAABYAAABMAAAAAAAAAAAAAAAEAAAAAAAAAAEAAABZWVkKAAAAACgAAAAoAAAAZAAAAGQAAAAAAAAAzMzMAAAAAABQAAAAUAAAAGQAAABkAAAAAAAAABcAAAAUAAAAAAAAAAAAAAD/fwAA/38AAAAAAAAJAAAABAAAAEqKdAoeAAAAaAAAAAAAAAAAAAAAAAAAAAAAAAAAAAAAECcAABAnAAAAAAAAAAAAAAAAAAAAAAAAAAAAAAAAAAAAAAAAAAAAABQAAAAAAAAAwMD/AAAAAABkAAAAMgAAAAAAAABkAAAAAAAAAH9/fwAKAAAAIgAAABgAAAAAAAAAAAAAAAAAAAAAAAAAAAAAAAAAAAAkAAAAJAAAAAAAAAAHAAAAAAAAAAAAAAAAAAAAAAAAAAAAAAAAAAAAf39/ACUAAABYAAAAAAAAAAAAAAAAAAAAAAAAAAAAAAAAAAAAAAAAAAAAAAAAAAAAAAAAAAAAAAA/AAAAAAAAAKCGAQAAAAAAAAAAAAAAAAAMAAAAAQAAAAAAAAAAAAAAAAAAAB8AAABUAAAAi47jAP///wEAAAAAAAAAAAAAAAAAAAAAAAAAAAAAAAAAAAAAAAAAAAAAAAJ/f38AWVlZA8zMzADAwP8Af39/AAAAAAAAAAAAAAAAAAAAAAAAAAAAIQAAABgAAAAUAAAAMAQAAM0IAAADGQAA4wsAABAAAAAmAAAACAAAAP//////////"/>
+                <pr:smNativeData xmlns:pr="smNativeData" xmlns="smNativeData" val="SMDATA_15_bQt8ZhMAAAAlAAAAZQAAAA0AAAAAqQEAAJAAAACpAQAAkAAAAAAAAAABAAAAAAAAAAEAAABQAAAAhbacS3FV1T8AAAAAAAAAAAAAAAAAAOA/AAAAAAAA4D8AAAAAAADgPwAAAAAAAOA/AAAAAAAA4D8AAAAAAADgPwAAAAAAAOA/AAAAAAAA4D8CAAAAjAAAAAEAAAAAAAAAi47jAP///wgAAAAAAAAAAAAAAAAAAAAAAAAAAAAAAAAAAAAAeAAAAAEAAABAAAAAAAAAAAAAAABaAAAAAAAAAAAAAAAAAAAAAAAAAAAAAAAAAAAAAAAAAAAAAAAAAAAAAAAAAAAAAAAAAAAAAAAAAAAAAAAAAAAAAAAAAAAAAAAAAAAAFAAAADwAAAAAAAAAAAAAAAAAAAkUAAAAAQAAABQAAAAUAAAAFAAAAAEAAAAAAAAAZAAAAGQAAAAAAAAAZAAAAGQAAAAVAAAAYAAAAAAAAAAAAAAADwAAACADAAAAAAAAAAAAAAEAAACgMgAAVgcAAKr4//8BAAAAf39/AAEAAABkAAAAAAAAABQAAABAHwAAAAAAACYAAAAAAAAAwOD//wAAAAAmAAAAZAAAABYAAABMAAAAAAAAAAAAAAAEAAAAAAAAAAEAAABZWVkKAAAAACgAAAAoAAAAZAAAAGQAAAAAAAAAzMzMAAAAAABQAAAAUAAAAGQAAABkAAAAAAAAABcAAAAUAAAAAAAAAAAAAAD/fwAA/38AAAAAAAAJAAAABAAAAEqKdAoeAAAAaAAAAAAAAAAAAAAAAAAAAAAAAAAAAAAAECcAABAnAAAAAAAAAAAAAAAAAAAAAAAAAAAAAAAAAAAAAAAAAAAAABQAAAAAAAAAwMD/AAAAAABkAAAAMgAAAAAAAABkAAAAAAAAAH9/fwAKAAAAIgAAABgAAAAAAAAAAAAAAAAAAAAAAAAAAAAAAAAAAAAkAAAAJAAAAAAAAAAHAAAAAAAAAAAAAAAAAAAAAAAAAAAAAAAAAAAAf39/ACUAAABYAAAAAAAAAAAAAAAAAAAAAAAAAAAAAAAAAAAAAAAAAAAAAAAAAAAAAAAAAAAAAAA/AAAAAAAAAKCGAQAAAAAAAAAAAAAAAAAMAAAAAQAAAAAAAAAAAAAAAAAAAB8AAABUAAAAi47jAP///wEAAAAAAAAAAAAAAAAAAAAAAAAAAAAAAAAAAAAAAAAAAAAAAAJ/f38AWVlZA8zMzADAwP8Af39/AAAAAAAAAAAAAAAAAAAAAAAAAAAAIQAAABgAAAAUAAAAMAQAAM0IAAADGQAA4wsAABAAAAAmAAAACAAAAP//////////"/>
               </a:ext>
             </a:extLst>
           </p:cNvSpPr>
@@ -11155,7 +11013,7 @@
           <p:cNvSpPr>
             <a:extLst>
               <a:ext uri="smNativeData">
-                <pr:smNativeData xmlns:pr="smNativeData" xmlns="smNativeData" val="SMDATA_15_9kV5ZhMAAAAlAAAAZQAAAA0AAAAAqQEAAJAAAACpAQAAkAAAAAAAAAABAAAAAAAAAAEAAABQAAAAhbacS3FV1T8AAAAAAAAAAAAAAAAAAOA/AAAAAAAA4D8AAAAAAADgPwAAAAAAAOA/AAAAAAAA4D8AAAAAAADgPwAAAAAAAOA/AAAAAAAA4D8CAAAAjAAAAAEAAAAAAAAAi47jAP///wgAAAAAAAAAAAAAAAAAAAAAAAAAAAAAAAAAAAAAeAAAAAEAAABAAAAAAAAAAAAAAABaAAAAAAAAAAAAAAAAAAAAAAAAAAAAAAAAAAAAAAAAAAAAAAAAAAAAAAAAAAAAAAAAAAAAAAAAAAAAAAAAAAAAAAAAAAAAAAAAAAAAFAAAADwAAAAAAAAAAAAAAAAAAAkUAAAAAQAAABQAAAAUAAAAFAAAAAEAAAAAAAAAZAAAAGQAAAAAAAAAZAAAAGQAAAAVAAAAYAAAAAAAAAAAAAAADwAAACADAAAAAAAAAAAAAAEAAACgMgAAVgcAAKr4//8BAAAAf39/AAEAAABkAAAAAAAAABQAAABAHwAAAAAAACYAAAAAAAAAwOD//wAAAAAmAAAAZAAAABYAAABMAAAAAAAAAAAAAAAEAAAAAAAAAAEAAABZWVkKAAAAACgAAAAoAAAAZAAAAGQAAAAAAAAAzMzMAAAAAABQAAAAUAAAAGQAAABkAAAAAAAAABcAAAAUAAAAAAAAAAAAAAD/fwAA/38AAAAAAAAJAAAABAAAAMdydoweAAAAaAAAAAAAAAAAAAAAAAAAAAAAAAAAAAAAECcAABAnAAAAAAAAAAAAAAAAAAAAAAAAAAAAAAAAAAAAAAAAAAAAABQAAAAAAAAAwMD/AAAAAABkAAAAMgAAAAAAAABkAAAAAAAAAH9/fwAKAAAAIgAAABgAAAAAAAAAAAAAAAAAAAAAAAAAAAAAAAAAAAAkAAAAJAAAAAAAAAAHAAAAAAAAAAAAAAAAAAAAAAAAAAAAAAAAAAAAf39/ACUAAABYAAAAAAAAAAAAAAAAAAAAAAAAAAAAAAAAAAAAAAAAAAAAAAAAAAAAAAAAAAAAAAA/AAAAAAAAAKCGAQAAAAAAAAAAAAAAAAAMAAAAAQAAAAAAAAAAAAAAAAAAAB8AAABUAAAAi47jAP///wEAAAAAAAAAAAAAAAAAAAAAAAAAAAAAAAAAAAAAAAAAAAAAAAJ/f38AWVlZA8zMzADAwP8Af39/AAAAAAAAAAAAAAAAAAAAAAAAAAAAIQAAABgAAAAUAAAAMAQAAN4NAAADGQAA9BAAABAAAAAmAAAACAAAAP//////////"/>
+                <pr:smNativeData xmlns:pr="smNativeData" xmlns="smNativeData" val="SMDATA_15_bQt8ZhMAAAAlAAAAZQAAAA0AAAAAqQEAAJAAAACpAQAAkAAAAAAAAAABAAAAAAAAAAEAAABQAAAAhbacS3FV1T8AAAAAAAAAAAAAAAAAAOA/AAAAAAAA4D8AAAAAAADgPwAAAAAAAOA/AAAAAAAA4D8AAAAAAADgPwAAAAAAAOA/AAAAAAAA4D8CAAAAjAAAAAEAAAAAAAAAi47jAP///wgAAAAAAAAAAAAAAAAAAAAAAAAAAAAAAAAAAAAAeAAAAAEAAABAAAAAAAAAAAAAAABaAAAAAAAAAAAAAAAAAAAAAAAAAAAAAAAAAAAAAAAAAAAAAAAAAAAAAAAAAAAAAAAAAAAAAAAAAAAAAAAAAAAAAAAAAAAAAAAAAAAAFAAAADwAAAAAAAAAAAAAAAAAAAkUAAAAAQAAABQAAAAUAAAAFAAAAAEAAAAAAAAAZAAAAGQAAAAAAAAAZAAAAGQAAAAVAAAAYAAAAAAAAAAAAAAADwAAACADAAAAAAAAAAAAAAEAAACgMgAAVgcAAKr4//8BAAAAf39/AAEAAABkAAAAAAAAABQAAABAHwAAAAAAACYAAAAAAAAAwOD//wAAAAAmAAAAZAAAABYAAABMAAAAAAAAAAAAAAAEAAAAAAAAAAEAAABZWVkKAAAAACgAAAAoAAAAZAAAAGQAAAAAAAAAzMzMAAAAAABQAAAAUAAAAGQAAABkAAAAAAAAABcAAAAUAAAAAAAAAAAAAAD/fwAA/38AAAAAAAAJAAAABAAAAMdydoweAAAAaAAAAAAAAAAAAAAAAAAAAAAAAAAAAAAAECcAABAnAAAAAAAAAAAAAAAAAAAAAAAAAAAAAAAAAAAAAAAAAAAAABQAAAAAAAAAwMD/AAAAAABkAAAAMgAAAAAAAABkAAAAAAAAAH9/fwAKAAAAIgAAABgAAAAAAAAAAAAAAAAAAAAAAAAAAAAAAAAAAAAkAAAAJAAAAAAAAAAHAAAAAAAAAAAAAAAAAAAAAAAAAAAAAAAAAAAAf39/ACUAAABYAAAAAAAAAAAAAAAAAAAAAAAAAAAAAAAAAAAAAAAAAAAAAAAAAAAAAAAAAAAAAAA/AAAAAAAAAKCGAQAAAAAAAAAAAAAAAAAMAAAAAQAAAAAAAAAAAAAAAAAAAB8AAABUAAAAi47jAP///wEAAAAAAAAAAAAAAAAAAAAAAAAAAAAAAAAAAAAAAAAAAAAAAAJ/f38AWVlZA8zMzADAwP8Af39/AAAAAAAAAAAAAAAAAAAAAAAAAAAAIQAAABgAAAAUAAAAMAQAAN4NAAADGQAA9BAAABAAAAAmAAAACAAAAP//////////"/>
               </a:ext>
             </a:extLst>
           </p:cNvSpPr>
@@ -11220,7 +11078,7 @@
           <p:cNvSpPr>
             <a:extLst>
               <a:ext uri="smNativeData">
-                <pr:smNativeData xmlns:pr="smNativeData" xmlns="smNativeData" val="SMDATA_15_9kV5ZhMAAAAlAAAAZQAAAA0AAAAAqQEAAJAAAACpAQAAkAAAAAAAAAABAAAAAAAAAAEAAABQAAAAhbacS3FV1T8AAAAAAAAAAAAAAAAAAOA/AAAAAAAA4D8AAAAAAADgPwAAAAAAAOA/AAAAAAAA4D8AAAAAAADgPwAAAAAAAOA/AAAAAAAA4D8CAAAAjAAAAAEAAAAAAAAAi47jAP///wgAAAAAAAAAAAAAAAAAAAAAAAAAAAAAAAAAAAAAeAAAAAEAAABAAAAAAAAAAAAAAABaAAAAAAAAAAAAAAAAAAAAAAAAAAAAAAAAAAAAAAAAAAAAAAAAAAAAAAAAAAAAAAAAAAAAAAAAAAAAAAAAAAAAAAAAAAAAAAAAAAAAFAAAADwAAAAAAAAAAAAAAAAAAAkUAAAAAQAAABQAAAAUAAAAFAAAAAEAAAAAAAAAZAAAAGQAAAAAAAAAZAAAAGQAAAAVAAAAYAAAAAAAAAAAAAAADwAAACADAAAAAAAAAAAAAAEAAACgMgAAVgcAAKr4//8BAAAAf39/AAEAAABkAAAAAAAAABQAAABAHwAAAAAAACYAAAAAAAAAwOD//wAAAAAmAAAAZAAAABYAAABMAAAAAAAAAAAAAAAEAAAAAAAAAAEAAABZWVkKAAAAACgAAAAoAAAAZAAAAGQAAAAAAAAAzMzMAAAAAABQAAAAUAAAAGQAAABkAAAAAAAAABcAAAAUAAAAAAAAAAAAAAD/fwAA/38AAAAAAAAJAAAABAAAAE554FYeAAAAaAAAAAAAAAAAAAAAAAAAAAAAAAAAAAAAECcAABAnAAAAAAAAAAAAAAAAAAAAAAAAAAAAAAAAAAAAAAAAAAAAABQAAAAAAAAAwMD/AAAAAABkAAAAMgAAAAAAAABkAAAAAAAAAH9/fwAKAAAAIgAAABgAAAAAAAAAAAAAAAAAAAAAAAAAAAAAAAAAAAAkAAAAJAAAAAAAAAAHAAAAAAAAAAAAAAAAAAAAAAAAAAAAAAAAAAAAf39/ACUAAABYAAAAAAAAAAAAAAAAAAAAAAAAAAAAAAAAAAAAAAAAAAAAAAAAAAAAAAAAAAAAAAA/AAAAAAAAAKCGAQAAAAAAAAAAAAAAAAAMAAAAAQAAAAAAAAAAAAAAAAAAAB8AAABUAAAAi47jAP///wEAAAAAAAAAAAAAAAAAAAAAAAAAAAAAAAAAAAAAAAAAAAAAAAJ/f38AWVlZA8zMzADAwP8Af39/AAAAAAAAAAAAAAAAAAAAAAAAAAAAIQAAABgAAAAUAAAAMAQAAAQTAAADGQAAGhYAABAAAAAmAAAACAAAAP//////////"/>
+                <pr:smNativeData xmlns:pr="smNativeData" xmlns="smNativeData" val="SMDATA_15_bQt8ZhMAAAAlAAAAZQAAAA0AAAAAqQEAAJAAAACpAQAAkAAAAAAAAAABAAAAAAAAAAEAAABQAAAAhbacS3FV1T8AAAAAAAAAAAAAAAAAAOA/AAAAAAAA4D8AAAAAAADgPwAAAAAAAOA/AAAAAAAA4D8AAAAAAADgPwAAAAAAAOA/AAAAAAAA4D8CAAAAjAAAAAEAAAAAAAAAi47jAP///wgAAAAAAAAAAAAAAAAAAAAAAAAAAAAAAAAAAAAAeAAAAAEAAABAAAAAAAAAAAAAAABaAAAAAAAAAAAAAAAAAAAAAAAAAAAAAAAAAAAAAAAAAAAAAAAAAAAAAAAAAAAAAAAAAAAAAAAAAAAAAAAAAAAAAAAAAAAAAAAAAAAAFAAAADwAAAAAAAAAAAAAAAAAAAkUAAAAAQAAABQAAAAUAAAAFAAAAAEAAAAAAAAAZAAAAGQAAAAAAAAAZAAAAGQAAAAVAAAAYAAAAAAAAAAAAAAADwAAACADAAAAAAAAAAAAAAEAAACgMgAAVgcAAKr4//8BAAAAf39/AAEAAABkAAAAAAAAABQAAABAHwAAAAAAACYAAAAAAAAAwOD//wAAAAAmAAAAZAAAABYAAABMAAAAAAAAAAAAAAAEAAAAAAAAAAEAAABZWVkKAAAAACgAAAAoAAAAZAAAAGQAAAAAAAAAzMzMAAAAAABQAAAAUAAAAGQAAABkAAAAAAAAABcAAAAUAAAAAAAAAAAAAAD/fwAA/38AAAAAAAAJAAAABAAAAE554FYeAAAAaAAAAAAAAAAAAAAAAAAAAAAAAAAAAAAAECcAABAnAAAAAAAAAAAAAAAAAAAAAAAAAAAAAAAAAAAAAAAAAAAAABQAAAAAAAAAwMD/AAAAAABkAAAAMgAAAAAAAABkAAAAAAAAAH9/fwAKAAAAIgAAABgAAAAAAAAAAAAAAAAAAAAAAAAAAAAAAAAAAAAkAAAAJAAAAAAAAAAHAAAAAAAAAAAAAAAAAAAAAAAAAAAAAAAAAAAAf39/ACUAAABYAAAAAAAAAAAAAAAAAAAAAAAAAAAAAAAAAAAAAAAAAAAAAAAAAAAAAAAAAAAAAAA/AAAAAAAAAKCGAQAAAAAAAAAAAAAAAAAMAAAAAQAAAAAAAAAAAAAAAAAAAB8AAABUAAAAi47jAP///wEAAAAAAAAAAAAAAAAAAAAAAAAAAAAAAAAAAAAAAAAAAAAAAAJ/f38AWVlZA8zMzADAwP8Af39/AAAAAAAAAAAAAAAAAAAAAAAAAAAAIQAAABgAAAAUAAAAMAQAAAQTAAADGQAAGhYAABAAAAAmAAAACAAAAP//////////"/>
               </a:ext>
             </a:extLst>
           </p:cNvSpPr>
@@ -11285,7 +11143,7 @@
           <p:cNvSpPr>
             <a:extLst>
               <a:ext uri="smNativeData">
-                <pr:smNativeData xmlns:pr="smNativeData" xmlns="smNativeData" val="SMDATA_15_9kV5ZhMAAAAlAAAAZQAAAA0AAAAAqQEAAJAAAACpAQAAkAAAAAAAAAABAAAAAAAAAAEAAABQAAAAhbacS3FV1T8AAAAAAAAAAAAAAAAAAOA/AAAAAAAA4D8AAAAAAADgPwAAAAAAAOA/AAAAAAAA4D8AAAAAAADgPwAAAAAAAOA/AAAAAAAA4D8CAAAAjAAAAAEAAAAAAAAAi47jAP///wgAAAAAAAAAAAAAAAAAAAAAAAAAAAAAAAAAAAAAeAAAAAEAAABAAAAAAAAAAAAAAABaAAAAAAAAAAAAAAAAAAAAAAAAAAAAAAAAAAAAAAAAAAAAAAAAAAAAAAAAAAAAAAAAAAAAAAAAAAAAAAAAAAAAAAAAAAAAAAAAAAAAFAAAADwAAAAAAAAAAAAAAAAAAAkUAAAAAQAAABQAAAAUAAAAFAAAAAEAAAAAAAAAZAAAAGQAAAAAAAAAZAAAAGQAAAAVAAAAYAAAAAAAAAAAAAAADwAAACADAAAAAAAAAAAAAAEAAACgMgAAVgcAAKr4//8BAAAAf39/AAEAAABkAAAAAAAAABQAAABAHwAAAAAAACYAAAAAAAAAwOD//wAAAAAmAAAAZAAAABYAAABMAAAAAAAAAAAAAAAEAAAAAAAAAAEAAABZWVkKAAAAACgAAAAoAAAAZAAAAGQAAAAAAAAAzMzMAAAAAABQAAAAUAAAAGQAAABkAAAAAAAAABcAAAAUAAAAAAAAAAAAAAD/fwAA/38AAAAAAAAJAAAABAAAAARNBpkeAAAAaAAAAAAAAAAAAAAAAAAAAAAAAAAAAAAAECcAABAnAAAAAAAAAAAAAAAAAAAAAAAAAAAAAAAAAAAAAAAAAAAAABQAAAAAAAAAwMD/AAAAAABkAAAAMgAAAAAAAABkAAAAAAAAAH9/fwAKAAAAIgAAABgAAAAAAAAAAAAAAAAAAAAAAAAAAAAAAAAAAAAkAAAAJAAAAAAAAAAHAAAAAAAAAAAAAAAAAAAAAAAAAAAAAAAAAAAAf39/ACUAAABYAAAAAAAAAAAAAAAAAAAAAAAAAAAAAAAAAAAAAAAAAAAAAAAAAAAAAAAAAAAAAAA/AAAAAAAAAKCGAQAAAAAAAAAAAAAAAAAMAAAAAQAAAAAAAAAAAAAAAAAAAB8AAABUAAAAi47jAP///wEAAAAAAAAAAAAAAAAAAAAAAAAAAAAAAAAAAAAAAAAAAAAAAAJ/f38AWVlZA8zMzADAwP8Af39/AAAAAAAAAAAAAAAAAAAAAAAAAAAAIQAAABgAAAAUAAAAMAQAACoYAAADGQAAQBsAABAAAAAmAAAACAAAAP//////////"/>
+                <pr:smNativeData xmlns:pr="smNativeData" xmlns="smNativeData" val="SMDATA_15_bQt8ZhMAAAAlAAAAZQAAAA0AAAAAqQEAAJAAAACpAQAAkAAAAAAAAAABAAAAAAAAAAEAAABQAAAAhbacS3FV1T8AAAAAAAAAAAAAAAAAAOA/AAAAAAAA4D8AAAAAAADgPwAAAAAAAOA/AAAAAAAA4D8AAAAAAADgPwAAAAAAAOA/AAAAAAAA4D8CAAAAjAAAAAEAAAAAAAAAi47jAP///wgAAAAAAAAAAAAAAAAAAAAAAAAAAAAAAAAAAAAAeAAAAAEAAABAAAAAAAAAAAAAAABaAAAAAAAAAAAAAAAAAAAAAAAAAAAAAAAAAAAAAAAAAAAAAAAAAAAAAAAAAAAAAAAAAAAAAAAAAAAAAAAAAAAAAAAAAAAAAAAAAAAAFAAAADwAAAAAAAAAAAAAAAAAAAkUAAAAAQAAABQAAAAUAAAAFAAAAAEAAAAAAAAAZAAAAGQAAAAAAAAAZAAAAGQAAAAVAAAAYAAAAAAAAAAAAAAADwAAACADAAAAAAAAAAAAAAEAAACgMgAAVgcAAKr4//8BAAAAf39/AAEAAABkAAAAAAAAABQAAABAHwAAAAAAACYAAAAAAAAAwOD//wAAAAAmAAAAZAAAABYAAABMAAAAAAAAAAAAAAAEAAAAAAAAAAEAAABZWVkKAAAAACgAAAAoAAAAZAAAAGQAAAAAAAAAzMzMAAAAAABQAAAAUAAAAGQAAABkAAAAAAAAABcAAAAUAAAAAAAAAAAAAAD/fwAA/38AAAAAAAAJAAAABAAAAARNBpkeAAAAaAAAAAAAAAAAAAAAAAAAAAAAAAAAAAAAECcAABAnAAAAAAAAAAAAAAAAAAAAAAAAAAAAAAAAAAAAAAAAAAAAABQAAAAAAAAAwMD/AAAAAABkAAAAMgAAAAAAAABkAAAAAAAAAH9/fwAKAAAAIgAAABgAAAAAAAAAAAAAAAAAAAAAAAAAAAAAAAAAAAAkAAAAJAAAAAAAAAAHAAAAAAAAAAAAAAAAAAAAAAAAAAAAAAAAAAAAf39/ACUAAABYAAAAAAAAAAAAAAAAAAAAAAAAAAAAAAAAAAAAAAAAAAAAAAAAAAAAAAAAAAAAAAA/AAAAAAAAAKCGAQAAAAAAAAAAAAAAAAAMAAAAAQAAAAAAAAAAAAAAAAAAAB8AAABUAAAAi47jAP///wEAAAAAAAAAAAAAAAAAAAAAAAAAAAAAAAAAAAAAAAAAAAAAAAJ/f38AWVlZA8zMzADAwP8Af39/AAAAAAAAAAAAAAAAAAAAAAAAAAAAIQAAABgAAAAUAAAAMAQAACoYAAADGQAAQBsAABAAAAAmAAAACAAAAP//////////"/>
               </a:ext>
             </a:extLst>
           </p:cNvSpPr>
@@ -11350,7 +11208,7 @@
           <p:cNvSpPr>
             <a:extLst>
               <a:ext uri="smNativeData">
-                <pr:smNativeData xmlns:pr="smNativeData" xmlns="smNativeData" val="SMDATA_15_9kV5ZhMAAAAlAAAAZQAAAA0AAAAAqQEAAJAAAACpAQAAkAAAAAAAAAABAAAAAAAAAAEAAABQAAAAhbacS3FV1T8AAAAAAAAAAAAAAAAAAOA/AAAAAAAA4D8AAAAAAADgPwAAAAAAAOA/AAAAAAAA4D8AAAAAAADgPwAAAAAAAOA/AAAAAAAA4D8CAAAAjAAAAAEAAAAAAAAAi47jAP///wgAAAAAAAAAAAAAAAAAAAAAAAAAAAAAAAAAAAAAeAAAAAEAAABAAAAAAAAAAAAAAABaAAAAAAAAAAAAAAAAAAAAAAAAAAAAAAAAAAAAAAAAAAAAAAAAAAAAAAAAAAAAAAAAAAAAAAAAAAAAAAAAAAAAAAAAAAAAAAAAAAAAFAAAADwAAAAAAAAAAAAAAAAAAAkUAAAAAQAAABQAAAAUAAAAFAAAAAEAAAAAAAAAZAAAAGQAAAAAAAAAZAAAAGQAAAAVAAAAYAAAAAAAAAAAAAAADwAAACADAAAAAAAAAAAAAAEAAACgMgAAVgcAAKr4//8BAAAAf39/AAEAAABkAAAAAAAAABQAAABAHwAAAAAAACYAAAAAAAAAwOD//wAAAAAmAAAAZAAAABYAAABMAAAAAAAAAAAAAAAEAAAAAAAAAAEAAABZWVkKAAAAACgAAAAoAAAAZAAAAGQAAAAAAAAAzMzMAAAAAABQAAAAUAAAAGQAAABkAAAAAAAAABcAAAAUAAAAAAAAAAAAAAD/fwAA/38AAAAAAAAJAAAABAAAAFQBpU4eAAAAaAAAAAAAAAAAAAAAAAAAAAAAAAAAAAAAECcAABAnAAAAAAAAAAAAAAAAAAAAAAAAAAAAAAAAAAAAAAAAAAAAABQAAAAAAAAAwMD/AAAAAABkAAAAMgAAAAAAAABkAAAAAAAAAH9/fwAKAAAAIgAAABgAAAAAAAAAAAAAAAAAAAAAAAAAAAAAAAAAAAAkAAAAJAAAAAAAAAAHAAAAAAAAAAAAAAAAAAAAAAAAAAAAAAAAAAAAf39/ACUAAABYAAAAAAAAAAAAAAAAAAAAAAAAAAAAAAAAAAAAAAAAAAAAAAAAAAAAAAAAAAAAAAA/AAAAAAAAAKCGAQAAAAAAAAAAAAAAAAAMAAAAAQAAAAAAAAAAAAAAAAAAAB8AAABUAAAAi47jAP///wEAAAAAAAAAAAAAAAAAAAAAAAAAAAAAAAAAAAAAAAAAAAAAAAJ/f38AWVlZA8zMzADAwP8Af39/AAAAAAAAAAAAAAAAAAAAAAAAAAAAIQAAABgAAAAUAAAAMAQAAPkcAAADGQAADyAAABAAAAAmAAAACAAAAP//////////"/>
+                <pr:smNativeData xmlns:pr="smNativeData" xmlns="smNativeData" val="SMDATA_15_bQt8ZhMAAAAlAAAAZQAAAA0AAAAAqQEAAJAAAACpAQAAkAAAAAAAAAABAAAAAAAAAAEAAABQAAAAhbacS3FV1T8AAAAAAAAAAAAAAAAAAOA/AAAAAAAA4D8AAAAAAADgPwAAAAAAAOA/AAAAAAAA4D8AAAAAAADgPwAAAAAAAOA/AAAAAAAA4D8CAAAAjAAAAAEAAAAAAAAAi47jAP///wgAAAAAAAAAAAAAAAAAAAAAAAAAAAAAAAAAAAAAeAAAAAEAAABAAAAAAAAAAAAAAABaAAAAAAAAAAAAAAAAAAAAAAAAAAAAAAAAAAAAAAAAAAAAAAAAAAAAAAAAAAAAAAAAAAAAAAAAAAAAAAAAAAAAAAAAAAAAAAAAAAAAFAAAADwAAAAAAAAAAAAAAAAAAAkUAAAAAQAAABQAAAAUAAAAFAAAAAEAAAAAAAAAZAAAAGQAAAAAAAAAZAAAAGQAAAAVAAAAYAAAAAAAAAAAAAAADwAAACADAAAAAAAAAAAAAAEAAACgMgAAVgcAAKr4//8BAAAAf39/AAEAAABkAAAAAAAAABQAAABAHwAAAAAAACYAAAAAAAAAwOD//wAAAAAmAAAAZAAAABYAAABMAAAAAAAAAAAAAAAEAAAAAAAAAAEAAABZWVkKAAAAACgAAAAoAAAAZAAAAGQAAAAAAAAAzMzMAAAAAABQAAAAUAAAAGQAAABkAAAAAAAAABcAAAAUAAAAAAAAAAAAAAD/fwAA/38AAAAAAAAJAAAABAAAAFQBpU4eAAAAaAAAAAAAAAAAAAAAAAAAAAAAAAAAAAAAECcAABAnAAAAAAAAAAAAAAAAAAAAAAAAAAAAAAAAAAAAAAAAAAAAABQAAAAAAAAAwMD/AAAAAABkAAAAMgAAAAAAAABkAAAAAAAAAH9/fwAKAAAAIgAAABgAAAAAAAAAAAAAAAAAAAAAAAAAAAAAAAAAAAAkAAAAJAAAAAAAAAAHAAAAAAAAAAAAAAAAAAAAAAAAAAAAAAAAAAAAf39/ACUAAABYAAAAAAAAAAAAAAAAAAAAAAAAAAAAAAAAAAAAAAAAAAAAAAAAAAAAAAAAAAAAAAA/AAAAAAAAAKCGAQAAAAAAAAAAAAAAAAAMAAAAAQAAAAAAAAAAAAAAAAAAAB8AAABUAAAAi47jAP///wEAAAAAAAAAAAAAAAAAAAAAAAAAAAAAAAAAAAAAAAAAAAAAAAJ/f38AWVlZA8zMzADAwP8Af39/AAAAAAAAAAAAAAAAAAAAAAAAAAAAIQAAABgAAAAUAAAAMAQAAPkcAAADGQAADyAAABAAAAAmAAAACAAAAP//////////"/>
               </a:ext>
             </a:extLst>
           </p:cNvSpPr>
@@ -11415,7 +11273,7 @@
           <p:cNvSpPr>
             <a:extLst>
               <a:ext uri="smNativeData">
-                <pr:smNativeData xmlns:pr="smNativeData" xmlns="smNativeData" val="SMDATA_15_9kV5ZhMAAAAlAAAAZQAAAA0AAAAAqQEAAJAAAACpAQAAkAAAAAAAAAABAAAAAAAAAAEAAABQAAAAhbacS3FV1T8AAAAAAAAAAAAAAAAAAOA/AAAAAAAA4D8AAAAAAADgPwAAAAAAAOA/AAAAAAAA4D8AAAAAAADgPwAAAAAAAOA/AAAAAAAA4D8CAAAAjAAAAAEAAAAAAAAAi47jAP///wgAAAAAAAAAAAAAAAAAAAAAAAAAAAAAAAAAAAAAeAAAAAEAAABAAAAAAAAAAAAAAABaAAAAAAAAAAAAAAAAAAAAAAAAAAAAAAAAAAAAAAAAAAAAAAAAAAAAAAAAAAAAAAAAAAAAAAAAAAAAAAAAAAAAAAAAAAAAAAAAAAAAFAAAADwAAAAAAAAAAAAAAAAAAAkUAAAAAQAAABQAAAAUAAAAFAAAAAEAAAAAAAAAZAAAAGQAAAAAAAAAZAAAAGQAAAAVAAAAYAAAAAAAAAAAAAAADwAAACADAAAAAAAAAAAAAAEAAACgMgAAVgcAAKr4//8BAAAAf39/AAEAAABkAAAAAAAAABQAAABAHwAAAAAAACYAAAAAAAAAwOD//wAAAAAmAAAAZAAAABYAAABMAAAAAAAAAAAAAAAEAAAAAAAAAAEAAABZWVkKAAAAACgAAAAoAAAAZAAAAGQAAAAAAAAAzMzMAAAAAABQAAAAUAAAAGQAAABkAAAAAAAAABcAAAAUAAAAAAAAAAAAAAD/fwAA/38AAAAAAAAJAAAABAAAACOg4r4eAAAAaAAAAAAAAAAAAAAAAAAAAAAAAAAAAAAAECcAABAnAAAAAAAAAAAAAAAAAAAAAAAAAAAAAAAAAAAAAAAAAAAAABQAAAAAAAAAwMD/AAAAAABkAAAAMgAAAAAAAABkAAAAAAAAAH9/fwAKAAAAIgAAABgAAAAAAAAAAAAAAAAAAAAAAAAAAAAAAAAAAAAkAAAAJAAAAAAAAAAHAAAAAAAAAAAAAAAAAAAAAAAAAAAAAAAAAAAAf39/ACUAAABYAAAAAAAAAAAAAAAAAAAAAAAAAAAAAAAAAAAAAAAAAAAAAAAAAAAAAAAAAAAAAAA/AAAAAAAAAKCGAQAAAAAAAAAAAAAAAAAMAAAAAQAAAAAAAAAAAAAAAAAAAB8AAABUAAAAi47jAP///wEAAAAAAAAAAAAAAAAAAAAAAAAAAAAAAAAAAAAAAAAAAAAAAAJ/f38AWVlZA8zMzADAwP8Af39/AAAAAAAAAAAAAAAAAAAAAAAAAAAAIQAAABgAAAAUAAAAMAQAAMkhAAADGQAA3yQAABAAAAAmAAAACAAAAP//////////"/>
+                <pr:smNativeData xmlns:pr="smNativeData" xmlns="smNativeData" val="SMDATA_15_bQt8ZhMAAAAlAAAAZQAAAA0AAAAAqQEAAJAAAACpAQAAkAAAAAAAAAABAAAAAAAAAAEAAABQAAAAhbacS3FV1T8AAAAAAAAAAAAAAAAAAOA/AAAAAAAA4D8AAAAAAADgPwAAAAAAAOA/AAAAAAAA4D8AAAAAAADgPwAAAAAAAOA/AAAAAAAA4D8CAAAAjAAAAAEAAAAAAAAAi47jAP///wgAAAAAAAAAAAAAAAAAAAAAAAAAAAAAAAAAAAAAeAAAAAEAAABAAAAAAAAAAAAAAABaAAAAAAAAAAAAAAAAAAAAAAAAAAAAAAAAAAAAAAAAAAAAAAAAAAAAAAAAAAAAAAAAAAAAAAAAAAAAAAAAAAAAAAAAAAAAAAAAAAAAFAAAADwAAAAAAAAAAAAAAAAAAAkUAAAAAQAAABQAAAAUAAAAFAAAAAEAAAAAAAAAZAAAAGQAAAAAAAAAZAAAAGQAAAAVAAAAYAAAAAAAAAAAAAAADwAAACADAAAAAAAAAAAAAAEAAACgMgAAVgcAAKr4//8BAAAAf39/AAEAAABkAAAAAAAAABQAAABAHwAAAAAAACYAAAAAAAAAwOD//wAAAAAmAAAAZAAAABYAAABMAAAAAAAAAAAAAAAEAAAAAAAAAAEAAABZWVkKAAAAACgAAAAoAAAAZAAAAGQAAAAAAAAAzMzMAAAAAABQAAAAUAAAAGQAAABkAAAAAAAAABcAAAAUAAAAAAAAAAAAAAD/fwAA/38AAAAAAAAJAAAABAAAACOg4r4eAAAAaAAAAAAAAAAAAAAAAAAAAAAAAAAAAAAAECcAABAnAAAAAAAAAAAAAAAAAAAAAAAAAAAAAAAAAAAAAAAAAAAAABQAAAAAAAAAwMD/AAAAAABkAAAAMgAAAAAAAABkAAAAAAAAAH9/fwAKAAAAIgAAABgAAAAAAAAAAAAAAAAAAAAAAAAAAAAAAAAAAAAkAAAAJAAAAAAAAAAHAAAAAAAAAAAAAAAAAAAAAAAAAAAAAAAAAAAAf39/ACUAAABYAAAAAAAAAAAAAAAAAAAAAAAAAAAAAAAAAAAAAAAAAAAAAAAAAAAAAAAAAAAAAAA/AAAAAAAAAKCGAQAAAAAAAAAAAAAAAAAMAAAAAQAAAAAAAAAAAAAAAAAAAB8AAABUAAAAi47jAP///wEAAAAAAAAAAAAAAAAAAAAAAAAAAAAAAAAAAAAAAAAAAAAAAAJ/f38AWVlZA8zMzADAwP8Af39/AAAAAAAAAAAAAAAAAAAAAAAAAAAAIQAAABgAAAAUAAAAMAQAAMkhAAADGQAA3yQAABAAAAAmAAAACAAAAP//////////"/>
               </a:ext>
             </a:extLst>
           </p:cNvSpPr>
@@ -11482,7 +11340,7 @@
             <a:endCxn id="4" idx="1"/>
             <a:extLst>
               <a:ext uri="smNativeData">
-                <pr:smNativeData xmlns:pr="smNativeData" xmlns="smNativeData" val="SMDATA_15_9kV5ZhMAAAAlAAAADwAAAA0AAAAAkAAAAEgAAACQAAAASAAAAAAAAAAAAAAAAAAAAAEAAABQAAAAAAAAAADWiMAAAAAAAAAAAAAAAAAAAPA/AAAAAAAA4D8AAAAAAADgPwAAAAAAAOA/AAAAAAAA4D8AAAAAAADgPwAAAAAAAOA/AAAAAAAA4D8CAAAAjAAAAAAAAAAAAAAAQoX0DP///wgAAAAAAAAAAAAAAAAAAAAAAAAAAAAAAAAAAAAAZAAAAAEAAABAAAAAAAAAAAAAAAAAAAAAAAAAAAAAAAAAAAAAAAAAAAAAAAAAAAAAAAAAAAAAAAAAAAAAAAAAAAAAAAAAAAAAAAAAAAAAAAAAAAAAAAAAAAAAAAAAAAAAFAAAADwAAAABAAAAAwAAAAE9hQAeAAAAAQAAACMAAAAjAAAAIwAAAB4AAAAAAAAAZAAAAGQAAAAAAAAAZAAAAGQAAAAVAAAAYAAAAAAAAAAAAAAADwAAACADAAAAAAAAAAAAAAEAAACgMgAAVgcAAKr4//8BAAAAf39/AAEAAABkAAAAAAAAABQAAABAHwAAAAAAACYAAAAAAAAAwOD//wAAAAAmAAAAZAAAABYAAABMAAAAAAAAAAAAAAAEAAAAAAAAAAEAAABZWVkKAAAAACgAAAAoAAAAZAAAAGQAAAAAAAAAzMzMAAAAAABQAAAAUAAAAGQAAABkAAAAAAAAABcAAAAUAAAAAAAAAAAAAAD/fwAA/38AAAAAAAAJAAAABAAAAMkMAAAeAAAAaAAAAAAAAAAAAAAAAAAAAAAAAAAAAAAAECcAABAnAAAAAAAAAAAAAAAAAAAAAAAAAAAAAAAAAAAAAAAAAAAAABQAAAAAAAAAwMD/AAAAAABkAAAAMgAAAAAAAABkAAAAAAAAAH9/fwAKAAAAIgAAABgAAAAAAAAAAAAAAAAAAAAAAAAAAAAAAAAAAAAkAAAAJAAAAAAAAAAHAAAAAAAAAAAAAAAAAAAAAAAAAAAAAAAAAAAAf39/ACUAAABYAAAAAAAAAAAAAAAAAAAAAAAAAAAAAAAAAAAAAAAAAAAAAAAAAAAAAAAAAAAAAAA/AAAAAAAAAKCGAQAAAAAAAAAAAAAAAAAMAAAAAQAAAAAAAAAAAAAAAAAAAB8AAABUAAAAQoX0Bf///wEAAAAAAAAAAAAAAAAAAAAAAAAAAAAAAAAAAAAAAAAAAAE9hQB/f38AWVlZA8zMzADAwP8Af39/AAAAAAAAAAAAAAAAAAAAAAAAAAAAIQAAABgAAAAUAAAAMAQAAFgKAAAwBAAAaQ8AABAAAAAmAAAACAAAAP//////////"/>
+                <pr:smNativeData xmlns:pr="smNativeData" xmlns="smNativeData" val="SMDATA_15_bQt8ZhMAAAAlAAAADwAAAA0AAAAAkAAAAEgAAACQAAAASAAAAAAAAAAAAAAAAAAAAAEAAABQAAAAAAAAAADWiMAAAAAAAAAAAAAAAAAAAPA/AAAAAAAA4D8AAAAAAADgPwAAAAAAAOA/AAAAAAAA4D8AAAAAAADgPwAAAAAAAOA/AAAAAAAA4D8CAAAAjAAAAAAAAAAAAAAAQoX0DP///wgAAAAAAAAAAAAAAAAAAAAAAAAAAAAAAAAAAAAAZAAAAAEAAABAAAAAAAAAAAAAAAAAAAAAAAAAAAAAAAAAAAAAAAAAAAAAAAAAAAAAAAAAAAAAAAAAAAAAAAAAAAAAAAAAAAAAAAAAAAAAAAAAAAAAAAAAAAAAAAAAAAAAFAAAADwAAAABAAAAAwAAAAE9hQAeAAAAAQAAACMAAAAjAAAAIwAAAB4AAAAAAAAAZAAAAGQAAAAAAAAAZAAAAGQAAAAVAAAAYAAAAAAAAAAAAAAADwAAACADAAAAAAAAAAAAAAEAAACgMgAAVgcAAKr4//8BAAAAf39/AAEAAABkAAAAAAAAABQAAABAHwAAAAAAACYAAAAAAAAAwOD//wAAAAAmAAAAZAAAABYAAABMAAAAAAAAAAAAAAAEAAAAAAAAAAEAAABZWVkKAAAAACgAAAAoAAAAZAAAAGQAAAAAAAAAzMzMAAAAAABQAAAAUAAAAGQAAABkAAAAAAAAABcAAAAUAAAAAAAAAAAAAAD/fwAA/38AAAAAAAAJAAAABAAAAMkMAAAeAAAAaAAAAAAAAAAAAAAAAAAAAAAAAAAAAAAAECcAABAnAAAAAAAAAAAAAAAAAAAAAAAAAAAAAAAAAAAAAAAAAAAAABQAAAAAAAAAwMD/AAAAAABkAAAAMgAAAAAAAABkAAAAAAAAAH9/fwAKAAAAIgAAABgAAAAAAAAAAAAAAAAAAAAAAAAAAAAAAAAAAAAkAAAAJAAAAAAAAAAHAAAAAAAAAAAAAAAAAAAAAAAAAAAAAAAAAAAAf39/ACUAAABYAAAAAAAAAAAAAAAAAAAAAAAAAAAAAAAAAAAAAAAAAAAAAAAAAAAAAAAAAAAAAAA/AAAAAAAAAKCGAQAAAAAAAAAAAAAAAAAMAAAAAQAAAAAAAAAAAAAAAAAAAB8AAABUAAAAQoX0Bf///wEAAAAAAAAAAAAAAAAAAAAAAAAAAAAAAAAAAAAAAAAAAAE9hQB/f38AWVlZA8zMzADAwP8Af39/AAAAAAAAAAAAAAAAAAAAAAAAAAAAIQAAABgAAAAUAAAAMAQAAFgKAAAwBAAAaQ8AABAAAAAmAAAACAAAAP//////////"/>
               </a:ext>
             </a:extLst>
           </p:cNvCxnSpPr>
@@ -11518,7 +11376,7 @@
             <a:endCxn id="5" idx="1"/>
             <a:extLst>
               <a:ext uri="smNativeData">
-                <pr:smNativeData xmlns:pr="smNativeData" xmlns="smNativeData" val="SMDATA_15_9kV5ZhMAAAAlAAAADwAAAA0AAAAAkAAAAEgAAACQAAAASAAAAAAAAAAAAAAAAAAAAAEAAABQAAAAAAAAAADWiMAAAAAAAAAAAAAAAAAAAPA/AAAAAAAA4D8AAAAAAADgPwAAAAAAAOA/AAAAAAAA4D8AAAAAAADgPwAAAAAAAOA/AAAAAAAA4D8CAAAAjAAAAAAAAAAAAAAAQoX0DP///wgAAAAAAAAAAAAAAAAAAAAAAAAAAAAAAAAAAAAAZAAAAAEAAABAAAAAAAAAAAAAAAAAAAAAAAAAAAAAAAAAAAAAAAAAAAAAAAAAAAAAAAAAAAAAAAAAAAAAAAAAAAAAAAAAAAAAAAAAAAAAAAAAAAAAAAAAAAAAAAAAAAAAFAAAADwAAAABAAAAAwAAAAE9hQAeAAAAAQAAACMAAAAjAAAAIwAAAB4AAAAAAAAAZAAAAGQAAAAAAAAAZAAAAGQAAAAVAAAAYAAAAAAAAAAAAAAADwAAACADAAAAAAAAAAAAAAEAAACgMgAAVgcAAKr4//8BAAAAf39/AAEAAABkAAAAAAAAABQAAABAHwAAAAAAACYAAAAAAAAAwOD//wAAAAAmAAAAZAAAABYAAABMAAAAAAAAAAAAAAAEAAAAAAAAAAEAAABZWVkKAAAAACgAAAAoAAAAZAAAAGQAAAAAAAAAzMzMAAAAAABQAAAAUAAAAGQAAABkAAAAAAAAABcAAAAUAAAAAAAAAAAAAAD/fwAA/38AAAAAAAAJAAAABAAAAAAAAAAeAAAAaAAAAAAAAAAAAAAAAAAAAAAAAAAAAAAAECcAABAnAAAAAAAAAAAAAAAAAAAAAAAAAAAAAAAAAAAAAAAAAAAAABQAAAAAAAAAwMD/AAAAAABkAAAAMgAAAAAAAABkAAAAAAAAAH9/fwAKAAAAIgAAABgAAAAAAAAAAAAAAAAAAAAAAAAAAAAAAAAAAAAkAAAAJAAAAAAAAAAHAAAAAAAAAAAAAAAAAAAAAAAAAAAAAAAAAAAAf39/ACUAAABYAAAAAAAAAAAAAAAAAAAAAAAAAAAAAAAAAAAAAAAAAAAAAAAAAAAAAAAAAAAAAAA/AAAAAAAAAKCGAQAAAAAAAAAAAAAAAAAMAAAAAQAAAAAAAAAAAAAAAAAAAB8AAABUAAAAQoX0Bf///wEAAAAAAAAAAAAAAAAAAAAAAAAAAAAAAAAAAAAAAAAAAAE9hQB/f38AWVlZA8zMzADAwP8Af39/AAAAAAAAAAAAAAAAAAAAAAAAAAAAIQAAABgAAAAUAAAAMAQAAGkPAAAwBAAAjxQAABAAAAAmAAAACAAAAP//////////"/>
+                <pr:smNativeData xmlns:pr="smNativeData" xmlns="smNativeData" val="SMDATA_15_bQt8ZhMAAAAlAAAADwAAAA0AAAAAkAAAAEgAAACQAAAASAAAAAAAAAAAAAAAAAAAAAEAAABQAAAAAAAAAADWiMAAAAAAAAAAAAAAAAAAAPA/AAAAAAAA4D8AAAAAAADgPwAAAAAAAOA/AAAAAAAA4D8AAAAAAADgPwAAAAAAAOA/AAAAAAAA4D8CAAAAjAAAAAAAAAAAAAAAQoX0DP///wgAAAAAAAAAAAAAAAAAAAAAAAAAAAAAAAAAAAAAZAAAAAEAAABAAAAAAAAAAAAAAAAAAAAAAAAAAAAAAAAAAAAAAAAAAAAAAAAAAAAAAAAAAAAAAAAAAAAAAAAAAAAAAAAAAAAAAAAAAAAAAAAAAAAAAAAAAAAAAAAAAAAAFAAAADwAAAABAAAAAwAAAAE9hQAeAAAAAQAAACMAAAAjAAAAIwAAAB4AAAAAAAAAZAAAAGQAAAAAAAAAZAAAAGQAAAAVAAAAYAAAAAAAAAAAAAAADwAAACADAAAAAAAAAAAAAAEAAACgMgAAVgcAAKr4//8BAAAAf39/AAEAAABkAAAAAAAAABQAAABAHwAAAAAAACYAAAAAAAAAwOD//wAAAAAmAAAAZAAAABYAAABMAAAAAAAAAAAAAAAEAAAAAAAAAAEAAABZWVkKAAAAACgAAAAoAAAAZAAAAGQAAAAAAAAAzMzMAAAAAABQAAAAUAAAAGQAAABkAAAAAAAAABcAAAAUAAAAAAAAAAAAAAD/fwAA/38AAAAAAAAJAAAABAAAAAAAAAAeAAAAaAAAAAAAAAAAAAAAAAAAAAAAAAAAAAAAECcAABAnAAAAAAAAAAAAAAAAAAAAAAAAAAAAAAAAAAAAAAAAAAAAABQAAAAAAAAAwMD/AAAAAABkAAAAMgAAAAAAAABkAAAAAAAAAH9/fwAKAAAAIgAAABgAAAAAAAAAAAAAAAAAAAAAAAAAAAAAAAAAAAAkAAAAJAAAAAAAAAAHAAAAAAAAAAAAAAAAAAAAAAAAAAAAAAAAAAAAf39/ACUAAABYAAAAAAAAAAAAAAAAAAAAAAAAAAAAAAAAAAAAAAAAAAAAAAAAAAAAAAAAAAAAAAA/AAAAAAAAAKCGAQAAAAAAAAAAAAAAAAAMAAAAAQAAAAAAAAAAAAAAAAAAAB8AAABUAAAAQoX0Bf///wEAAAAAAAAAAAAAAAAAAAAAAAAAAAAAAAAAAAAAAAAAAAE9hQB/f38AWVlZA8zMzADAwP8Af39/AAAAAAAAAAAAAAAAAAAAAAAAAAAAIQAAABgAAAAUAAAAMAQAAGkPAAAwBAAAjxQAABAAAAAmAAAACAAAAP//////////"/>
               </a:ext>
             </a:extLst>
           </p:cNvCxnSpPr>
@@ -11554,7 +11412,7 @@
             <a:endCxn id="6" idx="1"/>
             <a:extLst>
               <a:ext uri="smNativeData">
-                <pr:smNativeData xmlns:pr="smNativeData" xmlns="smNativeData" val="SMDATA_15_9kV5ZhMAAAAlAAAADwAAAA0AAAAAkAAAAEgAAACQAAAASAAAAAAAAAAAAAAAAAAAAAEAAABQAAAAAAAAAADWiMAAAAAAAAAAAAAAAAAAAPA/AAAAAAAA4D8AAAAAAADgPwAAAAAAAOA/AAAAAAAA4D8AAAAAAADgPwAAAAAAAOA/AAAAAAAA4D8CAAAAjAAAAAAAAAAAAAAAQoX0DP///wgAAAAAAAAAAAAAAAAAAAAAAAAAAAAAAAAAAAAAZAAAAAEAAABAAAAAAAAAAAAAAAAAAAAAAAAAAAAAAAAAAAAAAAAAAAAAAAAAAAAAAAAAAAAAAAAAAAAAAAAAAAAAAAAAAAAAAAAAAAAAAAAAAAAAAAAAAAAAAAAAAAAAFAAAADwAAAABAAAAAwAAAAE9hQAeAAAAAQAAACMAAAAjAAAAIwAAAB4AAAAAAAAAZAAAAGQAAAAAAAAAZAAAAGQAAAAVAAAAYAAAAAAAAAAAAAAADwAAACADAAAAAAAAAAAAAAEAAACgMgAAVgcAAKr4//8BAAAAf39/AAEAAABkAAAAAAAAABQAAABAHwAAAAAAACYAAAAAAAAAwOD//wAAAAAmAAAAZAAAABYAAABMAAAAAAAAAAAAAAAEAAAAAAAAAAEAAABZWVkKAAAAACgAAAAoAAAAZAAAAGQAAAAAAAAAzMzMAAAAAABQAAAAUAAAAGQAAABkAAAAAAAAABcAAAAUAAAAAAAAAAAAAAD/fwAA/38AAAAAAAAJAAAABAAAAB++y0QeAAAAaAAAAAAAAAAAAAAAAAAAAAAAAAAAAAAAECcAABAnAAAAAAAAAAAAAAAAAAAAAAAAAAAAAAAAAAAAAAAAAAAAABQAAAAAAAAAwMD/AAAAAABkAAAAMgAAAAAAAABkAAAAAAAAAH9/fwAKAAAAIgAAABgAAAAAAAAAAAAAAAAAAAAAAAAAAAAAAAAAAAAkAAAAJAAAAAAAAAAHAAAAAAAAAAAAAAAAAAAAAAAAAAAAAAAAAAAAf39/ACUAAABYAAAAAAAAAAAAAAAAAAAAAAAAAAAAAAAAAAAAAAAAAAAAAAAAAAAAAAAAAAAAAAA/AAAAAAAAAKCGAQAAAAAAAAAAAAAAAAAMAAAAAQAAAAAAAAAAAAAAAAAAAB8AAABUAAAAQoX0Bf///wEAAAAAAAAAAAAAAAAAAAAAAAAAAAAAAAAAAAAAAAAAAAE9hQB/f38AWVlZA8zMzADAwP8Af39/AAAAAAAAAAAAAAAAAAAAAAAAAAAAIQAAABgAAAAUAAAAMAQAAI8UAAAwBAAAtRkAABAAAAAmAAAACAAAAP//////////"/>
+                <pr:smNativeData xmlns:pr="smNativeData" xmlns="smNativeData" val="SMDATA_15_bQt8ZhMAAAAlAAAADwAAAA0AAAAAkAAAAEgAAACQAAAASAAAAAAAAAAAAAAAAAAAAAEAAABQAAAAAAAAAADWiMAAAAAAAAAAAAAAAAAAAPA/AAAAAAAA4D8AAAAAAADgPwAAAAAAAOA/AAAAAAAA4D8AAAAAAADgPwAAAAAAAOA/AAAAAAAA4D8CAAAAjAAAAAAAAAAAAAAAQoX0DP///wgAAAAAAAAAAAAAAAAAAAAAAAAAAAAAAAAAAAAAZAAAAAEAAABAAAAAAAAAAAAAAAAAAAAAAAAAAAAAAAAAAAAAAAAAAAAAAAAAAAAAAAAAAAAAAAAAAAAAAAAAAAAAAAAAAAAAAAAAAAAAAAAAAAAAAAAAAAAAAAAAAAAAFAAAADwAAAABAAAAAwAAAAE9hQAeAAAAAQAAACMAAAAjAAAAIwAAAB4AAAAAAAAAZAAAAGQAAAAAAAAAZAAAAGQAAAAVAAAAYAAAAAAAAAAAAAAADwAAACADAAAAAAAAAAAAAAEAAACgMgAAVgcAAKr4//8BAAAAf39/AAEAAABkAAAAAAAAABQAAABAHwAAAAAAACYAAAAAAAAAwOD//wAAAAAmAAAAZAAAABYAAABMAAAAAAAAAAAAAAAEAAAAAAAAAAEAAABZWVkKAAAAACgAAAAoAAAAZAAAAGQAAAAAAAAAzMzMAAAAAABQAAAAUAAAAGQAAABkAAAAAAAAABcAAAAUAAAAAAAAAAAAAAD/fwAA/38AAAAAAAAJAAAABAAAAB++y0QeAAAAaAAAAAAAAAAAAAAAAAAAAAAAAAAAAAAAECcAABAnAAAAAAAAAAAAAAAAAAAAAAAAAAAAAAAAAAAAAAAAAAAAABQAAAAAAAAAwMD/AAAAAABkAAAAMgAAAAAAAABkAAAAAAAAAH9/fwAKAAAAIgAAABgAAAAAAAAAAAAAAAAAAAAAAAAAAAAAAAAAAAAkAAAAJAAAAAAAAAAHAAAAAAAAAAAAAAAAAAAAAAAAAAAAAAAAAAAAf39/ACUAAABYAAAAAAAAAAAAAAAAAAAAAAAAAAAAAAAAAAAAAAAAAAAAAAAAAAAAAAAAAAAAAAA/AAAAAAAAAKCGAQAAAAAAAAAAAAAAAAAMAAAAAQAAAAAAAAAAAAAAAAAAAB8AAABUAAAAQoX0Bf///wEAAAAAAAAAAAAAAAAAAAAAAAAAAAAAAAAAAAAAAAAAAAE9hQB/f38AWVlZA8zMzADAwP8Af39/AAAAAAAAAAAAAAAAAAAAAAAAAAAAIQAAABgAAAAUAAAAMAQAAI8UAAAwBAAAtRkAABAAAAAmAAAACAAAAP//////////"/>
               </a:ext>
             </a:extLst>
           </p:cNvCxnSpPr>
@@ -11588,7 +11446,7 @@
           <p:cNvCxnSpPr>
             <a:extLst>
               <a:ext uri="smNativeData">
-                <pr:smNativeData xmlns:pr="smNativeData" xmlns="smNativeData" val="SMDATA_15_9kV5ZhMAAAAlAAAADwAAAA0AAAAAkAAAAEgAAACQAAAASAAAAAAAAAAAAAAAAAAAAAEAAABQAAAAAAAAAADWiMAAAAAAAAAAAAAAAAAAAPA/AAAAAAAA4D8AAAAAAADgPwAAAAAAAOA/AAAAAAAA4D8AAAAAAADgPwAAAAAAAOA/AAAAAAAA4D8CAAAAjAAAAAAAAAAAAAAAQoX0DP///wgAAAAAAAAAAAAAAAAAAAAAAAAAAAAAAAAAAAAAZAAAAAEAAABAAAAAAAAAAAAAAAAAAAAAAAAAAAAAAAAAAAAAAAAAAAAAAAAAAAAAAAAAAAAAAAAAAAAAAAAAAAAAAAAAAAAAAAAAAAAAAAAAAAAAAAAAAAAAAAAAAAAAFAAAADwAAAABAAAAAwAAAAE9hQAeAAAAAQAAACMAAAAjAAAAIwAAAB4AAAAAAAAAZAAAAGQAAAAAAAAAZAAAAGQAAAAVAAAAYAAAAAAAAAAAAAAADwAAACADAAAAAAAAAAAAAAEAAACgMgAAVgcAAKr4//8BAAAAf39/AAEAAABkAAAAAAAAABQAAABAHwAAAAAAACYAAAAAAAAAwOD//wAAAAAmAAAAZAAAABYAAABMAAAAAAAAAAAAAAAEAAAAAAAAAAEAAABZWVkKAAAAACgAAAAoAAAAZAAAAGQAAAAAAAAAzMzMAAAAAABQAAAAUAAAAGQAAABkAAAAAAAAABcAAAAUAAAAAAAAAAAAAAD/fwAA/38AAAAAAAAJAAAABAAAAAAAAAAeAAAAaAAAAAAAAAAAAAAAAAAAAAAAAAAAAAAAECcAABAnAAAAAAAAAAAAAAAAAAAAAAAAAAAAAAAAAAAAAAAAAAAAABQAAAAAAAAAwMD/AAAAAABkAAAAMgAAAAAAAABkAAAAAAAAAH9/fwAKAAAAIgAAABgAAAAAAAAAAAAAAAAAAAAAAAAAAAAAAAAAAAAkAAAAJAAAAAAAAAAHAAAAAAAAAAAAAAAAAAAAAAAAAAAAAAAAAAAAf39/ACUAAABYAAAAAAAAAAAAAAAAAAAAAAAAAAAAAAAAAAAAAAAAAAAAAAAAAAAAAAAAAAAAAAA/AAAAAAAAAKCGAQAAAAAAAAAAAAAAAAAMAAAAAQAAAAAAAAAAAAAAAAAAAB8AAABUAAAAQoX0Bf///wEAAAAAAAAAAAAAAAAAAAAAAAAAAAAAAAAAAAAAAAAAAAE9hQB/f38AWVlZA8zMzADAwP8Af39/AAAAAAAAAAAAAAAAAAAAAAAAAAAAIQAAABgAAAAUAAAAMAQAAPUZAAAxBAAAGx8AABAAAAAmAAAACAAAAP//////////"/>
+                <pr:smNativeData xmlns:pr="smNativeData" xmlns="smNativeData" val="SMDATA_15_bQt8ZhMAAAAlAAAADwAAAA0AAAAAkAAAAEgAAACQAAAASAAAAAAAAAAAAAAAAAAAAAEAAABQAAAAAAAAAADWiMAAAAAAAAAAAAAAAAAAAPA/AAAAAAAA4D8AAAAAAADgPwAAAAAAAOA/AAAAAAAA4D8AAAAAAADgPwAAAAAAAOA/AAAAAAAA4D8CAAAAjAAAAAAAAAAAAAAAQoX0DP///wgAAAAAAAAAAAAAAAAAAAAAAAAAAAAAAAAAAAAAZAAAAAEAAABAAAAAAAAAAAAAAAAAAAAAAAAAAAAAAAAAAAAAAAAAAAAAAAAAAAAAAAAAAAAAAAAAAAAAAAAAAAAAAAAAAAAAAAAAAAAAAAAAAAAAAAAAAAAAAAAAAAAAFAAAADwAAAABAAAAAwAAAAE9hQAeAAAAAQAAACMAAAAjAAAAIwAAAB4AAAAAAAAAZAAAAGQAAAAAAAAAZAAAAGQAAAAVAAAAYAAAAAAAAAAAAAAADwAAACADAAAAAAAAAAAAAAEAAACgMgAAVgcAAKr4//8BAAAAf39/AAEAAABkAAAAAAAAABQAAABAHwAAAAAAACYAAAAAAAAAwOD//wAAAAAmAAAAZAAAABYAAABMAAAAAAAAAAAAAAAEAAAAAAAAAAEAAABZWVkKAAAAACgAAAAoAAAAZAAAAGQAAAAAAAAAzMzMAAAAAABQAAAAUAAAAGQAAABkAAAAAAAAABcAAAAUAAAAAAAAAAAAAAD/fwAA/38AAAAAAAAJAAAABAAAAAAAAAAeAAAAaAAAAAAAAAAAAAAAAAAAAAAAAAAAAAAAECcAABAnAAAAAAAAAAAAAAAAAAAAAAAAAAAAAAAAAAAAAAAAAAAAABQAAAAAAAAAwMD/AAAAAABkAAAAMgAAAAAAAABkAAAAAAAAAH9/fwAKAAAAIgAAABgAAAAAAAAAAAAAAAAAAAAAAAAAAAAAAAAAAAAkAAAAJAAAAAAAAAAHAAAAAAAAAAAAAAAAAAAAAAAAAAAAAAAAAAAAf39/ACUAAABYAAAAAAAAAAAAAAAAAAAAAAAAAAAAAAAAAAAAAAAAAAAAAAAAAAAAAAAAAAAAAAA/AAAAAAAAAKCGAQAAAAAAAAAAAAAAAAAMAAAAAQAAAAAAAAAAAAAAAAAAAB8AAABUAAAAQoX0Bf///wEAAAAAAAAAAAAAAAAAAAAAAAAAAAAAAAAAAAAAAAAAAAE9hQB/f38AWVlZA8zMzADAwP8Af39/AAAAAAAAAAAAAAAAAAAAAAAAAAAAIQAAABgAAAAUAAAAMAQAAPUZAAAxBAAAGx8AABAAAAAmAAAACAAAAP//////////"/>
               </a:ext>
             </a:extLst>
           </p:cNvCxnSpPr>
@@ -11622,7 +11480,7 @@
           <p:cNvCxnSpPr>
             <a:extLst>
               <a:ext uri="smNativeData">
-                <pr:smNativeData xmlns:pr="smNativeData" xmlns="smNativeData" val="SMDATA_15_9kV5ZhMAAAAlAAAADwAAAA0AAAAAkAAAAEgAAACQAAAASAAAAAAAAAAAAAAAAAAAAAEAAABQAAAAAAAAAADWiMAAAAAAAAAAAAAAAAAAAPA/AAAAAAAA4D8AAAAAAADgPwAAAAAAAOA/AAAAAAAA4D8AAAAAAADgPwAAAAAAAOA/AAAAAAAA4D8CAAAAjAAAAAAAAAAAAAAAQoX0DP///wgAAAAAAAAAAAAAAAAAAAAAAAAAAAAAAAAAAAAAZAAAAAEAAABAAAAAAAAAAAAAAAAAAAAAAAAAAAAAAAAAAAAAAAAAAAAAAAAAAAAAAAAAAAAAAAAAAAAAAAAAAAAAAAAAAAAAAAAAAAAAAAAAAAAAAAAAAAAAAAAAAAAAFAAAADwAAAABAAAAAwAAAAE9hQAeAAAAAQAAACMAAAAjAAAAIwAAAB4AAAAAAAAAZAAAAGQAAAAAAAAAZAAAAGQAAAAVAAAAYAAAAAAAAAAAAAAADwAAACADAAAAAAAAAAAAAAEAAACgMgAAVgcAAKr4//8BAAAAf39/AAEAAABkAAAAAAAAABQAAABAHwAAAAAAACYAAAAAAAAAwOD//wAAAAAmAAAAZAAAABYAAABMAAAAAAAAAAAAAAAEAAAAAAAAAAEAAABZWVkKAAAAACgAAAAoAAAAZAAAAGQAAAAAAAAAzMzMAAAAAABQAAAAUAAAAGQAAABkAAAAAAAAABcAAAAUAAAAAAAAAAAAAAD/fwAA/38AAAAAAAAJAAAABAAAACgAAAAeAAAAaAAAAAAAAAAAAAAAAAAAAAAAAAAAAAAAECcAABAnAAAAAAAAAAAAAAAAAAAAAAAAAAAAAAAAAAAAAAAAAAAAABQAAAAAAAAAwMD/AAAAAABkAAAAMgAAAAAAAABkAAAAAAAAAH9/fwAKAAAAIgAAABgAAAAAAAAAAAAAAAAAAAAAAAAAAAAAAAAAAAAkAAAAJAAAAAAAAAAHAAAAAAAAAAAAAAAAAAAAAAAAAAAAAAAAAAAAf39/ACUAAABYAAAAAAAAAAAAAAAAAAAAAAAAAAAAAAAAAAAAAAAAAAAAAAAAAAAAAAAAAAAAAAA/AAAAAAAAAKCGAQAAAAAAAAAAAAAAAAAMAAAAAQAAAAAAAAAAAAAAAAAAAB8AAABUAAAAQoX0Bf///wEAAAAAAAAAAAAAAAAAAAAAAAAAAAAAAAAAAAAAAAAAAAE9hQB/f38AWVlZA8zMzADAwP8Af39/AAAAAAAAAAAAAAAAAAAAAAAAAAAAIQAAABgAAAAUAAAAMAQAAFofAAAxBAAAgCQAABAAAAAmAAAACAAAAP//////////"/>
+                <pr:smNativeData xmlns:pr="smNativeData" xmlns="smNativeData" val="SMDATA_15_bQt8ZhMAAAAlAAAADwAAAA0AAAAAkAAAAEgAAACQAAAASAAAAAAAAAAAAAAAAAAAAAEAAABQAAAAAAAAAADWiMAAAAAAAAAAAAAAAAAAAPA/AAAAAAAA4D8AAAAAAADgPwAAAAAAAOA/AAAAAAAA4D8AAAAAAADgPwAAAAAAAOA/AAAAAAAA4D8CAAAAjAAAAAAAAAAAAAAAQoX0DP///wgAAAAAAAAAAAAAAAAAAAAAAAAAAAAAAAAAAAAAZAAAAAEAAABAAAAAAAAAAAAAAAAAAAAAAAAAAAAAAAAAAAAAAAAAAAAAAAAAAAAAAAAAAAAAAAAAAAAAAAAAAAAAAAAAAAAAAAAAAAAAAAAAAAAAAAAAAAAAAAAAAAAAFAAAADwAAAABAAAAAwAAAAE9hQAeAAAAAQAAACMAAAAjAAAAIwAAAB4AAAAAAAAAZAAAAGQAAAAAAAAAZAAAAGQAAAAVAAAAYAAAAAAAAAAAAAAADwAAACADAAAAAAAAAAAAAAEAAACgMgAAVgcAAKr4//8BAAAAf39/AAEAAABkAAAAAAAAABQAAABAHwAAAAAAACYAAAAAAAAAwOD//wAAAAAmAAAAZAAAABYAAABMAAAAAAAAAAAAAAAEAAAAAAAAAAEAAABZWVkKAAAAACgAAAAoAAAAZAAAAGQAAAAAAAAAzMzMAAAAAABQAAAAUAAAAGQAAABkAAAAAAAAABcAAAAUAAAAAAAAAAAAAAD/fwAA/38AAAAAAAAJAAAABAAAACgAAAAeAAAAaAAAAAAAAAAAAAAAAAAAAAAAAAAAAAAAECcAABAnAAAAAAAAAAAAAAAAAAAAAAAAAAAAAAAAAAAAAAAAAAAAABQAAAAAAAAAwMD/AAAAAABkAAAAMgAAAAAAAABkAAAAAAAAAH9/fwAKAAAAIgAAABgAAAAAAAAAAAAAAAAAAAAAAAAAAAAAAAAAAAAkAAAAJAAAAAAAAAAHAAAAAAAAAAAAAAAAAAAAAAAAAAAAAAAAAAAAf39/ACUAAABYAAAAAAAAAAAAAAAAAAAAAAAAAAAAAAAAAAAAAAAAAAAAAAAAAAAAAAAAAAAAAAA/AAAAAAAAAKCGAQAAAAAAAAAAAAAAAAAMAAAAAQAAAAAAAAAAAAAAAAAAAB8AAABUAAAAQoX0Bf///wEAAAAAAAAAAAAAAAAAAAAAAAAAAAAAAAAAAAAAAAAAAAE9hQB/f38AWVlZA8zMzADAwP8Af39/AAAAAAAAAAAAAAAAAAAAAAAAAAAAIQAAABgAAAAUAAAAMAQAAFofAAAxBAAAgCQAABAAAAAmAAAACAAAAP//////////"/>
               </a:ext>
             </a:extLst>
           </p:cNvCxnSpPr>
@@ -11689,7 +11547,7 @@
             <a:spLocks noGrp="1" noChangeArrowheads="1"/>
             <a:extLst>
               <a:ext uri="smNativeData">
-                <pr:smNativeData xmlns:pr="smNativeData" xmlns="smNativeData" val="SMDATA_15_9kV5ZhMAAAAlAAAAZAAAAA0AAAAAkAAAAJAAAACQAAAAkAAAAAAAAAAAAAAAAAAAAAEAAABQAAAAAAAAAAAA4D8AAAAAAADgPwAAAAAAAOA/AAAAAAAA4D8AAAAAAADgPwAAAAAAAOA/AAAAAAAA4D8AAAAAAADgPwAAAAAAAOA/AAAAAAAA4D8CAAAAjAAAAAAAAAAAAAAAQoX0DP///wgAAAAAAAAAAAAAAAAAAAAAAAAAAAAAAAAAAAAAZAAAAAEAAABAAAAAAAAAAAAAAAAAAAAAAAAAAAAAAAAAAAAAAAAAAAAAAAAAAAAAAAAAAAAAAAAAAAAAAAAAAAAAAAAAAAAAAAAAAAAAAAAAAAAAAAAAAAAAAAAAAAAAFAAAADwAAAAAAAAAAAAAAAAAAAkUAAAAAQAAABQAAAAUAAAAFAAAAAEAAAAAAAAAZAAAAGQAAAAAAAAAZAAAAGQAAAAVAAAAYAAAAAAAAAAAAAAADwAAACADAAAAAAAAAAAAAAEAAACgMgAAVgcAAKr4//8BAAAAf39/AAEAAABkAAAAAAAAABQAAABAHwAAAAAAACYAAAAAAAAAwOD//wAAAAAmAAAAZAAAABYAAABMAAAAAAAAAAAAAAAEAAAAAAAAAAEAAABZWVkKAAAAACgAAAAoAAAAZAAAAGQAAAAAAAAAzMzMAAAAAABQAAAAUAAAAGQAAABkAAAAAAAAABcAAAAUAAAAAAAAAAAAAAD/fwAA/38AAAAAAAAJAAAABAAAACOP964eAAAAaAAAAAAAAAAAAAAAAAAAAAAAAAAAAAAAECcAABAnAAAAAAAAAAAAAAAAAAAAAAAAAAAAAAAAAAAAAAAAAAAAABQAAAAAAAAAwMD/AAAAAABkAAAAMgAAAAAAAABkAAAAAAAAAH9/fwAKAAAAIgAAABgAAAAAAAAAAAAAAAAAAAAAAAAAAAAAAAAAAAAkAAAAJAAAAAAAAAAHAAAAAAAAAAAAAAAAAAAAAAAAAAAAAAAAAAAAf39/ACUAAABYAAAAAAAAAAAAAAAAAAAAAAAAAAAAAAAAAAAAAAAAAAAAAAAAAAAAAAAAAAAAAAA/AAAAAAAAAKCGAQAAAAAAAAAAAAAAAAAMAAAAAQAAAAAAAAAAAAAAAAAAAB8AAABUAAAAAAAABQAAAAEAAAAAAAAAAAAAAAAAAAAAAAAAAAAAAAAAAAAAAAAAAAAAAAJ/f38AWVlZA8zMzADAwP8Af39/AAAAAAAAAAAAAAAAAAAAAAAAAAAAIQAAABgAAAAUAAAAFAMAALYCAAB/NwAAvwoAABAAAAAmAAAACAAAADwwAAAAAAAA"/>
+                <pr:smNativeData xmlns:pr="smNativeData" xmlns="smNativeData" val="SMDATA_15_bQt8ZhMAAAAlAAAAZAAAAA0AAAAAkAAAAJAAAACQAAAAkAAAAAAAAAAAAAAAAAAAAAEAAABQAAAAAAAAAAAA4D8AAAAAAADgPwAAAAAAAOA/AAAAAAAA4D8AAAAAAADgPwAAAAAAAOA/AAAAAAAA4D8AAAAAAADgPwAAAAAAAOA/AAAAAAAA4D8CAAAAjAAAAAAAAAAAAAAAQoX0DP///wgAAAAAAAAAAAAAAAAAAAAAAAAAAAAAAAAAAAAAZAAAAAEAAABAAAAAAAAAAAAAAAAAAAAAAAAAAAAAAAAAAAAAAAAAAAAAAAAAAAAAAAAAAAAAAAAAAAAAAAAAAAAAAAAAAAAAAAAAAAAAAAAAAAAAAAAAAAAAAAAAAAAAFAAAADwAAAAAAAAAAAAAAAAAAAkUAAAAAQAAABQAAAAUAAAAFAAAAAEAAAAAAAAAZAAAAGQAAAAAAAAAZAAAAGQAAAAVAAAAYAAAAAAAAAAAAAAADwAAACADAAAAAAAAAAAAAAEAAACgMgAAVgcAAKr4//8BAAAAf39/AAEAAABkAAAAAAAAABQAAABAHwAAAAAAACYAAAAAAAAAwOD//wAAAAAmAAAAZAAAABYAAABMAAAAAAAAAAAAAAAEAAAAAAAAAAEAAABZWVkKAAAAACgAAAAoAAAAZAAAAGQAAAAAAAAAzMzMAAAAAABQAAAAUAAAAGQAAABkAAAAAAAAABcAAAAUAAAAAAAAAAAAAAD/fwAA/38AAAAAAAAJAAAABAAAACOP964eAAAAaAAAAAAAAAAAAAAAAAAAAAAAAAAAAAAAECcAABAnAAAAAAAAAAAAAAAAAAAAAAAAAAAAAAAAAAAAAAAAAAAAABQAAAAAAAAAwMD/AAAAAABkAAAAMgAAAAAAAABkAAAAAAAAAH9/fwAKAAAAIgAAABgAAAAAAAAAAAAAAAAAAAAAAAAAAAAAAAAAAAAkAAAAJAAAAAAAAAAHAAAAAAAAAAAAAAAAAAAAAAAAAAAAAAAAAAAAf39/ACUAAABYAAAAAAAAAAAAAAAAAAAAAAAAAAAAAAAAAAAAAAAAAAAAAAAAAAAAAAAAAAAAAAA/AAAAAAAAAKCGAQAAAAAAAAAAAAAAAAAMAAAAAQAAAAAAAAAAAAAAAAAAAB8AAABUAAAAQoX0Bf///wEAAAAAAAAAAAAAAAAAAAAAAAAAAAAAAAAAAAAAAAAAAAAAAAJ/f38AWVlZA8zMzADAwP8Af39/AAAAAAAAAAAAAAAAAAAAAAAAAAAAIQAAABgAAAAUAAAAFAMAALYCAAB/NwAAvwoAABAAAAAmAAAACAAAADwwAAAAAAAA"/>
               </a:ext>
             </a:extLst>
           </p:cNvSpPr>
@@ -11879,7 +11737,7 @@
                 </a:tc>
                 <a:extLst>
                   <a:ext uri="smNativeData">
-                    <pr:rowheight xmlns="" xmlns:pr="smNativeData" dt="1719223798" type="min" val="381000"/>
+                    <pr:rowheight xmlns="" xmlns:pr="smNativeData" dt="1719405421" type="min" val="381000"/>
                   </a:ext>
                 </a:extLst>
               </a:tr>
@@ -12027,7 +11885,7 @@
                 </a:tc>
                 <a:extLst>
                   <a:ext uri="smNativeData">
-                    <pr:rowheight xmlns="" xmlns:pr="smNativeData" dt="1719223798" type="min" val="381000"/>
+                    <pr:rowheight xmlns="" xmlns:pr="smNativeData" dt="1719405421" type="min" val="381000"/>
                   </a:ext>
                 </a:extLst>
               </a:tr>
@@ -12175,7 +12033,7 @@
                 </a:tc>
                 <a:extLst>
                   <a:ext uri="smNativeData">
-                    <pr:rowheight xmlns="" xmlns:pr="smNativeData" dt="1719223798" type="min" val="381000"/>
+                    <pr:rowheight xmlns="" xmlns:pr="smNativeData" dt="1719405421" type="min" val="381000"/>
                   </a:ext>
                 </a:extLst>
               </a:tr>
@@ -12323,7 +12181,7 @@
                 </a:tc>
                 <a:extLst>
                   <a:ext uri="smNativeData">
-                    <pr:rowheight xmlns="" xmlns:pr="smNativeData" dt="1719223798" type="min" val="381000"/>
+                    <pr:rowheight xmlns="" xmlns:pr="smNativeData" dt="1719405421" type="min" val="381000"/>
                   </a:ext>
                 </a:extLst>
               </a:tr>
@@ -12331,77 +12189,6 @@
           </a:graphicData>
         </a:graphic>
       </p:graphicFrame>
-      <p:sp>
-        <p:nvSpPr>
-          <p:cNvPr id="4" name="Google Shape;170;p34"/>
-          <p:cNvSpPr>
-            <a:extLst>
-              <a:ext uri="smNativeData">
-                <pr:smNativeData xmlns:pr="smNativeData" xmlns="smNativeData" val="SMDATA_15_9kV5ZhMAAAAlAAAA9AEAAA0AAAAAOAEAAMYAAAA4AQAAxgAAAAAAAAABAAAAAAAAAAEAAABQAAAAe0ljtI6q2r8AAAAAAAD0PwAAAAAAAOA/AAAAAAAA4D8AAAAAAADgPwAAAAAAAOA/AAAAAAAA4D8AAAAAAADgPwAAAAAAAOA/AAAAAAAA4D8CAAAAjAAAAAEAAAAAAAAA8/PzAP///wgAAAAAAAAAAAAAAAAAAAAAAAAAAAAAAAAAAAAAeAAAAAEAAABAAAAAAAAAAAAAAABaAAAAAAAAAAAAAAAAAAAAAAAAAAAAAAAAAAAAAAAAAAAAAAAAAAAAAAAAAAAAAAAAAAAAAAAAAAAAAAAAAAAAAAAAAAAAAAAAAAAAFAAAADwAAAABAAAAAAAAAAE9hQAPAAAAAQAAACMAAAAjAAAAIwAAAB4AAAAAAAAASwAAAEsAAAAAAAAASwAAAEsAAAAVAAAAYAAAAAAAAAAAAAAADwAAACADAAAAAAAAAAAAAAEAAACgMgAAVgcAAKr4//8BAAAAf39/AAEAAABkAAAAAAAAABQAAABAHwAAAAAAACYAAAAAAAAAwOD//wAAAAAmAAAAZAAAABYAAABMAAAAAAAAAAAAAAAEAAAAAAAAAAEAAABZWVkKAAAAACgAAAAoAAAAZAAAAGQAAAAAAAAAzMzMAAAAAABQAAAAUAAAAGQAAABkAAAAAAAAABcAAAAUAAAAAAAAAAAAAAD/fwAA/38AAAAAAAAJAAAABAAAADpUCpYeAAAAaAAAAAAAAAAAAAAAAAAAAAAAAAAAAAAAECcAABAnAAAAAAAAAAAAAAAAAAAAAAAAAAAAAAAAAAAAAAAAAAAAABQAAAAAAAAAwMD/AAAAAABkAAAAMgAAAAAAAABkAAAAAAAAAH9/fwAKAAAAIgAAABgAAAAAAAAAAAAAAAAAAAAAAAAAAAAAAAAAAAAkAAAAJAAAAAAAAAAHAAAAAAAAAAAAAAAAAAAAAAAAAAAAAAAAAAAAf39/ACUAAABYAAAAAAAAAAAAAAAAAAAAAAAAAAAAAAAAAAAAAAAAAAAAAAAAAAAAAAAAAAAAAAA/AAAAAAAAAKCGAQAAAAAAAAAAAAAAAAAMAAAAAQAAAAAAAAAAAAAAAAAAAB8AAABUAAAA8/PzAP///wEAAAAAAAAAAAAAAAAAAAAAAAAAAAAAAAAAAAAAAAAAAAE9hQB/f38AWVlZA8zMzADAwP8Af39/AAAAAAAAAAAAAAAAAAAAAAAAAAAAIQAAABgAAAAUAAAA2CAAAFMCAADnNQAACwkAABAAAAAmAAAACAAAAP//////////"/>
-              </a:ext>
-            </a:extLst>
-          </p:cNvSpPr>
-          <p:nvPr/>
-        </p:nvSpPr>
-        <p:spPr>
-          <a:xfrm>
-            <a:off x="5339080" y="377825"/>
-            <a:ext cx="3423285" cy="1092200"/>
-          </a:xfrm>
-          <a:prstGeom prst="wedgeRectCallout">
-            <a:avLst>
-              <a:gd name="adj1" fmla="val -20833"/>
-              <a:gd name="adj2" fmla="val 62500"/>
-            </a:avLst>
-          </a:prstGeom>
-          <a:solidFill>
-            <a:srgbClr val="F3F3F3"/>
-          </a:solidFill>
-          <a:ln w="9525" cap="flat" cmpd="sng" algn="ctr">
-            <a:solidFill>
-              <a:srgbClr val="013D85"/>
-            </a:solidFill>
-            <a:prstDash val="solid"/>
-            <a:headEnd type="none"/>
-            <a:tailEnd type="none"/>
-          </a:ln>
-          <a:effectLst/>
-        </p:spPr>
-        <p:txBody>
-          <a:bodyPr vert="horz" wrap="square" lIns="198120" tIns="125730" rIns="198120" bIns="125730" numCol="1" spcCol="215900" anchor="ctr"/>
-          <a:lstStyle/>
-          <a:p>
-            <a:pPr marL="0" indent="0" algn="l">
-              <a:spcBef>
-                <a:spcPts val="0"/>
-              </a:spcBef>
-              <a:spcAft>
-                <a:spcPts val="0"/>
-              </a:spcAft>
-              <a:buNone/>
-            </a:pPr>
-            <a:r>
-              <a:rPr lang="ru-ru" sz="1500" cap="none">
-                <a:solidFill>
-                  <a:srgbClr val="02418B"/>
-                </a:solidFill>
-                <a:latin typeface="Roboto" pitchFamily="0" charset="0"/>
-                <a:ea typeface="Roboto" pitchFamily="0" charset="0"/>
-                <a:cs typeface="Roboto" pitchFamily="0" charset="0"/>
-              </a:rPr>
-              <a:t>Какие цели вы поставили и какие задачи решили своим проектом </a:t>
-            </a:r>
-            <a:endParaRPr sz="1500" cap="none">
-              <a:solidFill>
-                <a:srgbClr val="02418B"/>
-              </a:solidFill>
-              <a:latin typeface="Roboto" pitchFamily="0" charset="0"/>
-              <a:ea typeface="Roboto" pitchFamily="0" charset="0"/>
-              <a:cs typeface="Roboto" pitchFamily="0" charset="0"/>
-            </a:endParaRPr>
-          </a:p>
-        </p:txBody>
-      </p:sp>
     </p:spTree>
   </p:cSld>
   <p:clrMapOvr>
@@ -12441,7 +12228,7 @@
             <a:spLocks noGrp="1" noChangeArrowheads="1"/>
             <a:extLst>
               <a:ext uri="smNativeData">
-                <pr:smNativeData xmlns:pr="smNativeData" xmlns="smNativeData" val="SMDATA_15_9kV5ZhMAAAAlAAAAZAAAAA0AAAAAkAAAAJAAAACQAAAAkAAAAAAAAAAAAAAAAAAAAAEAAABQAAAAAAAAAAAA4D8AAAAAAADgPwAAAAAAAOA/AAAAAAAA4D8AAAAAAADgPwAAAAAAAOA/AAAAAAAA4D8AAAAAAADgPwAAAAAAAOA/AAAAAAAA4D8CAAAAjAAAAAAAAAAAAAAAQoX0DP///wgAAAAAAAAAAAAAAAAAAAAAAAAAAAAAAAAAAAAAZAAAAAEAAABAAAAAAAAAAAAAAAAAAAAAAAAAAAAAAAAAAAAAAAAAAAAAAAAAAAAAAAAAAAAAAAAAAAAAAAAAAAAAAAAAAAAAAAAAAAAAAAAAAAAAAAAAAAAAAAAAAAAAFAAAADwAAAAAAAAAAAAAAAAAAAkUAAAAAQAAABQAAAAUAAAAFAAAAAEAAAAAAAAAZAAAAGQAAAAAAAAAZAAAAGQAAAAVAAAAYAAAAAAAAAAAAAAADwAAACADAAAAAAAAAAAAAAEAAACgMgAAVgcAAKr4//8BAAAAf39/AAEAAABkAAAAAAAAABQAAABAHwAAAAAAACYAAAAAAAAAwOD//wAAAAAmAAAAZAAAABYAAABMAAAAAAAAAAAAAAAEAAAAAAAAAAEAAABZWVkKAAAAACgAAAAoAAAAZAAAAGQAAAAAAAAAzMzMAAAAAABQAAAAUAAAAGQAAABkAAAAAAAAABcAAAAUAAAAAAAAAAAAAAD/fwAA/38AAAAAAAAJAAAABAAAAGl3mg4eAAAAaAAAAAAAAAAAAAAAAAAAAAAAAAAAAAAAECcAABAnAAAAAAAAAAAAAAAAAAAAAAAAAAAAAAAAAAAAAAAAAAAAABQAAAAAAAAAwMD/AAAAAABkAAAAMgAAAAAAAABkAAAAAAAAAH9/fwAKAAAAIgAAABgAAAAAAAAAAAAAAAAAAAAAAAAAAAAAAAAAAAAkAAAAJAAAAAAAAAAHAAAAAAAAAAAAAAAAAAAAAAAAAAAAAAAAAAAAf39/ACUAAABYAAAAAAAAAAAAAAAAAAAAAAAAAAAAAAAAAAAAAAAAAAAAAAAAAAAAAAAAAAAAAAA/AAAAAAAAAKCGAQAAAAAAAAAAAAAAAAAMAAAAAQAAAAAAAAAAAAAAAAAAAB8AAABUAAAAAAAABQAAAAEAAAAAAAAAAAAAAAAAAAAAAAAAAAAAAAAAAAAAAAAAAAAAAAJ/f38AWVlZA8zMzADAwP8Af39/AAAAAAAAAAAAAAAAAAAAAAAAAAAAIQAAABgAAAAUAAAAFAMAALYCAAB/NwAAvwoAABAAAAAmAAAACAAAADwwAAAAAAAA"/>
+                <pr:smNativeData xmlns:pr="smNativeData" xmlns="smNativeData" val="SMDATA_15_bQt8ZhMAAAAlAAAAZAAAAA0AAAAAkAAAAJAAAACQAAAAkAAAAAAAAAAAAAAAAAAAAAEAAABQAAAAAAAAAAAA4D8AAAAAAADgPwAAAAAAAOA/AAAAAAAA4D8AAAAAAADgPwAAAAAAAOA/AAAAAAAA4D8AAAAAAADgPwAAAAAAAOA/AAAAAAAA4D8CAAAAjAAAAAAAAAAAAAAAQoX0DP///wgAAAAAAAAAAAAAAAAAAAAAAAAAAAAAAAAAAAAAZAAAAAEAAABAAAAAAAAAAAAAAAAAAAAAAAAAAAAAAAAAAAAAAAAAAAAAAAAAAAAAAAAAAAAAAAAAAAAAAAAAAAAAAAAAAAAAAAAAAAAAAAAAAAAAAAAAAAAAAAAAAAAAFAAAADwAAAAAAAAAAAAAAAAAAAkUAAAAAQAAABQAAAAUAAAAFAAAAAEAAAAAAAAAZAAAAGQAAAAAAAAAZAAAAGQAAAAVAAAAYAAAAAAAAAAAAAAADwAAACADAAAAAAAAAAAAAAEAAACgMgAAVgcAAKr4//8BAAAAf39/AAEAAABkAAAAAAAAABQAAABAHwAAAAAAACYAAAAAAAAAwOD//wAAAAAmAAAAZAAAABYAAABMAAAAAAAAAAAAAAAEAAAAAAAAAAEAAABZWVkKAAAAACgAAAAoAAAAZAAAAGQAAAAAAAAAzMzMAAAAAABQAAAAUAAAAGQAAABkAAAAAAAAABcAAAAUAAAAAAAAAAAAAAD/fwAA/38AAAAAAAAJAAAABAAAAGl3mg4eAAAAaAAAAAAAAAAAAAAAAAAAAAAAAAAAAAAAECcAABAnAAAAAAAAAAAAAAAAAAAAAAAAAAAAAAAAAAAAAAAAAAAAABQAAAAAAAAAwMD/AAAAAABkAAAAMgAAAAAAAABkAAAAAAAAAH9/fwAKAAAAIgAAABgAAAAAAAAAAAAAAAAAAAAAAAAAAAAAAAAAAAAkAAAAJAAAAAAAAAAHAAAAAAAAAAAAAAAAAAAAAAAAAAAAAAAAAAAAf39/ACUAAABYAAAAAAAAAAAAAAAAAAAAAAAAAAAAAAAAAAAAAAAAAAAAAAAAAAAAAAAAAAAAAAA/AAAAAAAAAKCGAQAAAAAAAAAAAAAAAAAMAAAAAQAAAAAAAAAAAAAAAAAAAB8AAABUAAAAQoX0Bf///wEAAAAAAAAAAAAAAAAAAAAAAAAAAAAAAAAAAAAAAAAAAAAAAAJ/f38AWVlZA8zMzADAwP8Af39/AAAAAAAAAAAAAAAAAAAAAAAAAAAAIQAAABgAAAAUAAAAFAMAALYCAAB/NwAAvwoAABAAAAAmAAAACAAAADwwAAAAAAAA"/>
               </a:ext>
             </a:extLst>
           </p:cNvSpPr>
@@ -12631,7 +12418,7 @@
                 </a:tc>
                 <a:extLst>
                   <a:ext uri="smNativeData">
-                    <pr:rowheight xmlns="" xmlns:pr="smNativeData" dt="1719223798" type="min" val="381000"/>
+                    <pr:rowheight xmlns="" xmlns:pr="smNativeData" dt="1719405421" type="min" val="381000"/>
                   </a:ext>
                 </a:extLst>
               </a:tr>
@@ -12779,7 +12566,7 @@
                 </a:tc>
                 <a:extLst>
                   <a:ext uri="smNativeData">
-                    <pr:rowheight xmlns="" xmlns:pr="smNativeData" dt="1719223798" type="min" val="381000"/>
+                    <pr:rowheight xmlns="" xmlns:pr="smNativeData" dt="1719405421" type="min" val="381000"/>
                   </a:ext>
                 </a:extLst>
               </a:tr>
@@ -12927,7 +12714,7 @@
                 </a:tc>
                 <a:extLst>
                   <a:ext uri="smNativeData">
-                    <pr:rowheight xmlns="" xmlns:pr="smNativeData" dt="1719223798" type="min" val="381000"/>
+                    <pr:rowheight xmlns="" xmlns:pr="smNativeData" dt="1719405421" type="min" val="381000"/>
                   </a:ext>
                 </a:extLst>
               </a:tr>
@@ -13067,7 +12854,7 @@
                 </a:tc>
                 <a:extLst>
                   <a:ext uri="smNativeData">
-                    <pr:rowheight xmlns="" xmlns:pr="smNativeData" dt="1719223798" type="min" val="381000"/>
+                    <pr:rowheight xmlns="" xmlns:pr="smNativeData" dt="1719405421" type="min" val="381000"/>
                   </a:ext>
                 </a:extLst>
               </a:tr>
@@ -13075,77 +12862,6 @@
           </a:graphicData>
         </a:graphic>
       </p:graphicFrame>
-      <p:sp>
-        <p:nvSpPr>
-          <p:cNvPr id="4" name="Google Shape;177;p35"/>
-          <p:cNvSpPr>
-            <a:extLst>
-              <a:ext uri="smNativeData">
-                <pr:smNativeData xmlns:pr="smNativeData" xmlns="smNativeData" val="SMDATA_15_9kV5ZhMAAAAlAAAA9AEAAA0AAAAAOAEAAMYAAAA4AQAAxgAAAAAAAAABAAAAAAAAAAEAAABQAAAAe0ljtI6q2r8AAAAAAAD0PwAAAAAAAOA/AAAAAAAA4D8AAAAAAADgPwAAAAAAAOA/AAAAAAAA4D8AAAAAAADgPwAAAAAAAOA/AAAAAAAA4D8CAAAAjAAAAAEAAAAAAAAA8/PzAP///wgAAAAAAAAAAAAAAAAAAAAAAAAAAAAAAAAAAAAAeAAAAAEAAABAAAAAAAAAAAAAAABaAAAAAAAAAAAAAAAAAAAAAAAAAAAAAAAAAAAAAAAAAAAAAAAAAAAAAAAAAAAAAAAAAAAAAAAAAAAAAAAAAAAAAAAAAAAAAAAAAAAAFAAAADwAAAABAAAAAAAAAAE9hQAPAAAAAQAAACMAAAAjAAAAIwAAAB4AAAAAAAAASwAAAEsAAAAAAAAASwAAAEsAAAAVAAAAYAAAAAAAAAAAAAAADwAAACADAAAAAAAAAAAAAAEAAACgMgAAVgcAAKr4//8BAAAAf39/AAEAAABkAAAAAAAAABQAAABAHwAAAAAAACYAAAAAAAAAwOD//wAAAAAmAAAAZAAAABYAAABMAAAAAAAAAAAAAAAEAAAAAAAAAAEAAABZWVkKAAAAACgAAAAoAAAAZAAAAGQAAAAAAAAAzMzMAAAAAABQAAAAUAAAAGQAAABkAAAAAAAAABcAAAAUAAAAAAAAAAAAAAD/fwAA/38AAAAAAAAJAAAABAAAACgVFOgeAAAAaAAAAAAAAAAAAAAAAAAAAAAAAAAAAAAAECcAABAnAAAAAAAAAAAAAAAAAAAAAAAAAAAAAAAAAAAAAAAAAAAAABQAAAAAAAAAwMD/AAAAAABkAAAAMgAAAAAAAABkAAAAAAAAAH9/fwAKAAAAIgAAABgAAAAAAAAAAAAAAAAAAAAAAAAAAAAAAAAAAAAkAAAAJAAAAAAAAAAHAAAAAAAAAAAAAAAAAAAAAAAAAAAAAAAAAAAAf39/ACUAAABYAAAAAAAAAAAAAAAAAAAAAAAAAAAAAAAAAAAAAAAAAAAAAAAAAAAAAAAAAAAAAAA/AAAAAAAAAKCGAQAAAAAAAAAAAAAAAAAMAAAAAQAAAAAAAAAAAAAAAAAAAB8AAABUAAAA8/PzAP///wEAAAAAAAAAAAAAAAAAAAAAAAAAAAAAAAAAAAAAAAAAAAE9hQB/f38AWVlZA8zMzADAwP8Af39/AAAAAAAAAAAAAAAAAAAAAAAAAAAAIQAAABgAAAAUAAAA2CAAAFMCAADnNQAACwkAABAAAAAmAAAACAAAAP//////////"/>
-              </a:ext>
-            </a:extLst>
-          </p:cNvSpPr>
-          <p:nvPr/>
-        </p:nvSpPr>
-        <p:spPr>
-          <a:xfrm>
-            <a:off x="5339080" y="377825"/>
-            <a:ext cx="3423285" cy="1092200"/>
-          </a:xfrm>
-          <a:prstGeom prst="wedgeRectCallout">
-            <a:avLst>
-              <a:gd name="adj1" fmla="val -20833"/>
-              <a:gd name="adj2" fmla="val 62500"/>
-            </a:avLst>
-          </a:prstGeom>
-          <a:solidFill>
-            <a:srgbClr val="F3F3F3"/>
-          </a:solidFill>
-          <a:ln w="9525" cap="flat" cmpd="sng" algn="ctr">
-            <a:solidFill>
-              <a:srgbClr val="013D85"/>
-            </a:solidFill>
-            <a:prstDash val="solid"/>
-            <a:headEnd type="none"/>
-            <a:tailEnd type="none"/>
-          </a:ln>
-          <a:effectLst/>
-        </p:spPr>
-        <p:txBody>
-          <a:bodyPr vert="horz" wrap="square" lIns="198120" tIns="125730" rIns="198120" bIns="125730" numCol="1" spcCol="215900" anchor="ctr"/>
-          <a:lstStyle/>
-          <a:p>
-            <a:pPr marL="0" indent="0" algn="l">
-              <a:spcBef>
-                <a:spcPts val="0"/>
-              </a:spcBef>
-              <a:spcAft>
-                <a:spcPts val="0"/>
-              </a:spcAft>
-              <a:buNone/>
-            </a:pPr>
-            <a:r>
-              <a:rPr lang="ru-ru" sz="1500" cap="none">
-                <a:solidFill>
-                  <a:srgbClr val="02418B"/>
-                </a:solidFill>
-                <a:latin typeface="Roboto" pitchFamily="0" charset="0"/>
-                <a:ea typeface="Roboto" pitchFamily="0" charset="0"/>
-                <a:cs typeface="Roboto" pitchFamily="0" charset="0"/>
-              </a:rPr>
-              <a:t>Что было в начале, что знали до курса, сколько времени заняло выполнение проекта</a:t>
-            </a:r>
-            <a:endParaRPr sz="1500" cap="none">
-              <a:solidFill>
-                <a:srgbClr val="02418B"/>
-              </a:solidFill>
-              <a:latin typeface="Roboto" pitchFamily="0" charset="0"/>
-              <a:ea typeface="Roboto" pitchFamily="0" charset="0"/>
-              <a:cs typeface="Roboto" pitchFamily="0" charset="0"/>
-            </a:endParaRPr>
-          </a:p>
-        </p:txBody>
-      </p:sp>
     </p:spTree>
   </p:cSld>
   <p:clrMapOvr>
@@ -13185,7 +12901,7 @@
             <a:spLocks noGrp="1" noChangeArrowheads="1"/>
             <a:extLst>
               <a:ext uri="smNativeData">
-                <pr:smNativeData xmlns:pr="smNativeData" xmlns="smNativeData" val="SMDATA_15_9kV5ZhMAAAAlAAAAZAAAAA0AAAAAkAAAAJAAAACQAAAAkAAAAAAAAAAAAAAAAAAAAAEAAABQAAAAAAAAAAAA4D8AAAAAAADgPwAAAAAAAOA/AAAAAAAA4D8AAAAAAADgPwAAAAAAAOA/AAAAAAAA4D8AAAAAAADgPwAAAAAAAOA/AAAAAAAA4D8CAAAAjAAAAAAAAAAAAAAAQoX0DP///wgAAAAAAAAAAAAAAAAAAAAAAAAAAAAAAAAAAAAAZAAAAAEAAABAAAAAAAAAAAAAAAAAAAAAAAAAAAAAAAAAAAAAAAAAAAAAAAAAAAAAAAAAAAAAAAAAAAAAAAAAAAAAAAAAAAAAAAAAAAAAAAAAAAAAAAAAAAAAAAAAAAAAFAAAADwAAAAAAAAAAAAAAAAAAAkUAAAAAQAAABQAAAAUAAAAFAAAAAEAAAAAAAAAZAAAAGQAAAAAAAAAZAAAAGQAAAAVAAAAYAAAAAAAAAAAAAAADwAAACADAAAAAAAAAAAAAAEAAACgMgAAVgcAAKr4//8BAAAAf39/AAEAAABkAAAAAAAAABQAAABAHwAAAAAAACYAAAAAAAAAwOD//wAAAAAmAAAAZAAAABYAAABMAAAAAAAAAAAAAAAEAAAAAAAAAAEAAABZWVkKAAAAACgAAAAoAAAAZAAAAGQAAAAAAAAAzMzMAAAAAABQAAAAUAAAAGQAAABkAAAAAAAAABcAAAAUAAAAAAAAAAAAAAD/fwAA/38AAAAAAAAJAAAABAAAAMeGczoeAAAAaAAAAAAAAAAAAAAAAAAAAAAAAAAAAAAAECcAABAnAAAAAAAAAAAAAAAAAAAAAAAAAAAAAAAAAAAAAAAAAAAAABQAAAAAAAAAwMD/AAAAAABkAAAAMgAAAAAAAABkAAAAAAAAAH9/fwAKAAAAIgAAABgAAAAAAAAAAAAAAAAAAAAAAAAAAAAAAAAAAAAkAAAAJAAAAAAAAAAHAAAAAAAAAAAAAAAAAAAAAAAAAAAAAAAAAAAAf39/ACUAAABYAAAAAAAAAAAAAAAAAAAAAAAAAAAAAAAAAAAAAAAAAAAAAAAAAAAAAAAAAAAAAAA/AAAAAAAAAKCGAQAAAAAAAAAAAAAAAAAMAAAAAQAAAAAAAAAAAAAAAAAAAB8AAABUAAAAAAAABQAAAAEAAAAAAAAAAAAAAAAAAAAAAAAAAAAAAAAAAAAAAAAAAAAAAAJ/f38AWVlZA8zMzADAwP8Af39/AAAAAAAAAAAAAAAAAAAAAAAAAAAAIQAAABgAAAAUAAAAFAMAALYCAAB/NwAAvwoAABAAAAAmAAAACAAAADwwAAAAAAAA"/>
+                <pr:smNativeData xmlns:pr="smNativeData" xmlns="smNativeData" val="SMDATA_15_bQt8ZhMAAAAlAAAAZAAAAA0AAAAAkAAAAJAAAACQAAAAkAAAAAAAAAAAAAAAAAAAAAEAAABQAAAAAAAAAAAA4D8AAAAAAADgPwAAAAAAAOA/AAAAAAAA4D8AAAAAAADgPwAAAAAAAOA/AAAAAAAA4D8AAAAAAADgPwAAAAAAAOA/AAAAAAAA4D8CAAAAjAAAAAAAAAAAAAAAQoX0DP///wgAAAAAAAAAAAAAAAAAAAAAAAAAAAAAAAAAAAAAZAAAAAEAAABAAAAAAAAAAAAAAAAAAAAAAAAAAAAAAAAAAAAAAAAAAAAAAAAAAAAAAAAAAAAAAAAAAAAAAAAAAAAAAAAAAAAAAAAAAAAAAAAAAAAAAAAAAAAAAAAAAAAAFAAAADwAAAAAAAAAAAAAAAAAAAkUAAAAAQAAABQAAAAUAAAAFAAAAAEAAAAAAAAAZAAAAGQAAAAAAAAAZAAAAGQAAAAVAAAAYAAAAAAAAAAAAAAADwAAACADAAAAAAAAAAAAAAEAAACgMgAAVgcAAKr4//8BAAAAf39/AAEAAABkAAAAAAAAABQAAABAHwAAAAAAACYAAAAAAAAAwOD//wAAAAAmAAAAZAAAABYAAABMAAAAAAAAAAAAAAAEAAAAAAAAAAEAAABZWVkKAAAAACgAAAAoAAAAZAAAAGQAAAAAAAAAzMzMAAAAAABQAAAAUAAAAGQAAABkAAAAAAAAABcAAAAUAAAAAAAAAAAAAAD/fwAA/38AAAAAAAAJAAAABAAAAMeGczoeAAAAaAAAAAAAAAAAAAAAAAAAAAAAAAAAAAAAECcAABAnAAAAAAAAAAAAAAAAAAAAAAAAAAAAAAAAAAAAAAAAAAAAABQAAAAAAAAAwMD/AAAAAABkAAAAMgAAAAAAAABkAAAAAAAAAH9/fwAKAAAAIgAAABgAAAAAAAAAAAAAAAAAAAAAAAAAAAAAAAAAAAAkAAAAJAAAAAAAAAAHAAAAAAAAAAAAAAAAAAAAAAAAAAAAAAAAAAAAf39/ACUAAABYAAAAAAAAAAAAAAAAAAAAAAAAAAAAAAAAAAAAAAAAAAAAAAAAAAAAAAAAAAAAAAA/AAAAAAAAAKCGAQAAAAAAAAAAAAAAAAAMAAAAAQAAAAAAAAAAAAAAAAAAAB8AAABUAAAAQoX0Bf///wEAAAAAAAAAAAAAAAAAAAAAAAAAAAAAAAAAAAAAAAAAAAAAAAJ/f38AWVlZA8zMzADAwP8Af39/AAAAAAAAAAAAAAAAAAAAAAAAAAAAIQAAABgAAAAUAAAAFAMAALYCAAB/NwAAvwoAABAAAAAmAAAACAAAADwwAAAAAAAA"/>
               </a:ext>
             </a:extLst>
           </p:cNvSpPr>
@@ -13375,7 +13091,7 @@
                 </a:tc>
                 <a:extLst>
                   <a:ext uri="smNativeData">
-                    <pr:rowheight xmlns="" xmlns:pr="smNativeData" dt="1719223798" type="min" val="381000"/>
+                    <pr:rowheight xmlns="" xmlns:pr="smNativeData" dt="1719405421" type="min" val="381000"/>
                   </a:ext>
                 </a:extLst>
               </a:tr>
@@ -13523,7 +13239,7 @@
                 </a:tc>
                 <a:extLst>
                   <a:ext uri="smNativeData">
-                    <pr:rowheight xmlns="" xmlns:pr="smNativeData" dt="1719223798" type="min" val="381000"/>
+                    <pr:rowheight xmlns="" xmlns:pr="smNativeData" dt="1719405421" type="min" val="381000"/>
                   </a:ext>
                 </a:extLst>
               </a:tr>
@@ -13663,7 +13379,7 @@
                 </a:tc>
                 <a:extLst>
                   <a:ext uri="smNativeData">
-                    <pr:rowheight xmlns="" xmlns:pr="smNativeData" dt="1719223798" type="min" val="381000"/>
+                    <pr:rowheight xmlns="" xmlns:pr="smNativeData" dt="1719405421" type="min" val="381000"/>
                   </a:ext>
                 </a:extLst>
               </a:tr>
@@ -13671,77 +13387,6 @@
           </a:graphicData>
         </a:graphic>
       </p:graphicFrame>
-      <p:sp>
-        <p:nvSpPr>
-          <p:cNvPr id="4" name="Google Shape;184;p36"/>
-          <p:cNvSpPr>
-            <a:extLst>
-              <a:ext uri="smNativeData">
-                <pr:smNativeData xmlns:pr="smNativeData" xmlns="smNativeData" val="SMDATA_15_9kV5ZhMAAAAlAAAA9AEAAA0AAAAAOAEAAMYAAAA4AQAAxgAAAAAAAAABAAAAAAAAAAEAAABQAAAAR+aRPxh47L8Gu2Hbosz8vwAAAAAAAOA/AAAAAAAA4D8AAAAAAADgPwAAAAAAAOA/AAAAAAAA4D8AAAAAAADgPwAAAAAAAOA/AAAAAAAA4D8CAAAAjAAAAAEAAAAAAAAA8/PzAP///wgAAAAAAAAAAAAAAAAAAAAAAAAAAAAAAAAAAAAAeAAAAAEAAABAAAAAAAAAAAAAAABaAAAAAAAAAAAAAAAAAAAAAAAAAAAAAAAAAAAAAAAAAAAAAAAAAAAAAAAAAAAAAAAAAAAAAAAAAAAAAAAAAAAAAAAAAAAAAAAAAAAAFAAAADwAAAABAAAAAAAAAAE9hQAPAAAAAQAAACMAAAAjAAAAIwAAAB4AAAAAAAAASwAAAEsAAAAAAAAASwAAAEsAAAAVAAAAYAAAAAAAAAAAAAAADwAAACADAAAAAAAAAAAAAAEAAACgMgAAVgcAAKr4//8BAAAAf39/AAEAAABkAAAAAAAAABQAAABAHwAAAAAAACYAAAAAAAAAwOD//wAAAAAmAAAAZAAAABYAAABMAAAAAAAAAAAAAAAEAAAAAAAAAAEAAABZWVkKAAAAACgAAAAoAAAAZAAAAGQAAAAAAAAAzMzMAAAAAABQAAAAUAAAAGQAAABkAAAAAAAAABcAAAAUAAAAAAAAAAAAAAD/fwAA/38AAAAAAAAJAAAABAAAAAECAwAeAAAAaAAAAAAAAAAAAAAAAAAAAAAAAAAAAAAAECcAABAnAAAAAAAAAAAAAAAAAAAAAAAAAAAAAAAAAAAAAAAAAAAAABQAAAAAAAAAwMD/AAAAAABkAAAAMgAAAAAAAABkAAAAAAAAAH9/fwAKAAAAIgAAABgAAAAAAAAAAAAAAAAAAAAAAAAAAAAAAAAAAAAkAAAAJAAAAAAAAAAHAAAAAAAAAAAAAAAAAAAAAAAAAAAAAAAAAAAAf39/ACUAAABYAAAAAAAAAAAAAAAAAAAAAAAAAAAAAAAAAAAAAAAAAAAAAAAAAAAAAAAAAAAAAAA/AAAAAAAAAKCGAQAAAAAAAAAAAAAAAAAMAAAAAQAAAAAAAAAAAAAAAAAAAB8AAABUAAAA8/PzAP///wEAAAAAAAAAAAAAAAAAAAAAAAAAAAAAAAAAAAAAAAAAAAE9hQB/f38AWVlZA8zMzADAwP8Af39/AAAAAAAAAAAAAAAAAAAAAAAAAAAAIQAAABgAAAAUAAAAVR0AALMbAABkMgAAaiIAABAAAAAmAAAACAAAAP//////////"/>
-              </a:ext>
-            </a:extLst>
-          </p:cNvSpPr>
-          <p:nvPr/>
-        </p:nvSpPr>
-        <p:spPr>
-          <a:xfrm>
-            <a:off x="4768215" y="4502785"/>
-            <a:ext cx="3423285" cy="1091565"/>
-          </a:xfrm>
-          <a:prstGeom prst="wedgeRectCallout">
-            <a:avLst>
-              <a:gd name="adj1" fmla="val -44483"/>
-              <a:gd name="adj2" fmla="val -89998"/>
-            </a:avLst>
-          </a:prstGeom>
-          <a:solidFill>
-            <a:srgbClr val="F3F3F3"/>
-          </a:solidFill>
-          <a:ln w="9525" cap="flat" cmpd="sng" algn="ctr">
-            <a:solidFill>
-              <a:srgbClr val="013D85"/>
-            </a:solidFill>
-            <a:prstDash val="solid"/>
-            <a:headEnd type="none"/>
-            <a:tailEnd type="none"/>
-          </a:ln>
-          <a:effectLst/>
-        </p:spPr>
-        <p:txBody>
-          <a:bodyPr vert="horz" wrap="square" lIns="198120" tIns="125730" rIns="198120" bIns="125730" numCol="1" spcCol="215900" anchor="ctr"/>
-          <a:lstStyle/>
-          <a:p>
-            <a:pPr marL="0" indent="0" algn="l">
-              <a:spcBef>
-                <a:spcPts val="600"/>
-              </a:spcBef>
-              <a:spcAft>
-                <a:spcPts val="0"/>
-              </a:spcAft>
-              <a:buNone/>
-            </a:pPr>
-            <a:r>
-              <a:rPr lang="ru-ru" sz="1500" cap="none">
-                <a:solidFill>
-                  <a:srgbClr val="02418B"/>
-                </a:solidFill>
-                <a:latin typeface="Roboto" pitchFamily="0" charset="0"/>
-                <a:ea typeface="Roboto" pitchFamily="0" charset="0"/>
-                <a:cs typeface="Roboto" pitchFamily="0" charset="0"/>
-              </a:rPr>
-              <a:t>Какие технологии использовались и какое у вас мнение о новых технологиях</a:t>
-            </a:r>
-            <a:endParaRPr sz="1500" cap="none">
-              <a:solidFill>
-                <a:srgbClr val="02418B"/>
-              </a:solidFill>
-              <a:latin typeface="Roboto" pitchFamily="0" charset="0"/>
-              <a:ea typeface="Roboto" pitchFamily="0" charset="0"/>
-              <a:cs typeface="Roboto" pitchFamily="0" charset="0"/>
-            </a:endParaRPr>
-          </a:p>
-        </p:txBody>
-      </p:sp>
     </p:spTree>
   </p:cSld>
   <p:clrMapOvr>
@@ -13781,7 +13426,7 @@
             <a:spLocks noGrp="1" noChangeArrowheads="1"/>
             <a:extLst>
               <a:ext uri="smNativeData">
-                <pr:smNativeData xmlns:pr="smNativeData" xmlns="smNativeData" val="SMDATA_15_9kV5ZhMAAAAlAAAAZAAAAA0AAAAAkAAAAJAAAACQAAAAkAAAAAAAAAAAAAAAAAAAAAEAAABQAAAAAAAAAAAA4D8AAAAAAADgPwAAAAAAAOA/AAAAAAAA4D8AAAAAAADgPwAAAAAAAOA/AAAAAAAA4D8AAAAAAADgPwAAAAAAAOA/AAAAAAAA4D8CAAAAjAAAAAAAAAAAAAAAQoX0DP///wgAAAAAAAAAAAAAAAAAAAAAAAAAAAAAAAAAAAAAZAAAAAEAAABAAAAAAAAAAAAAAAAAAAAAAAAAAAAAAAAAAAAAAAAAAAAAAAAAAAAAAAAAAAAAAAAAAAAAAAAAAAAAAAAAAAAAAAAAAAAAAAAAAAAAAAAAAAAAAAAAAAAAFAAAADwAAAAAAAAAAAAAAAAAAAkUAAAAAQAAABQAAAAUAAAAFAAAAAEAAAAAAAAAZAAAAGQAAAAAAAAAZAAAAGQAAAAVAAAAYAAAAAAAAAAAAAAADwAAACADAAAAAAAAAAAAAAEAAACgMgAAVgcAAKr4//8BAAAAf39/AAEAAABkAAAAAAAAABQAAABAHwAAAAAAACYAAAAAAAAAwOD//wAAAAAmAAAAZAAAABYAAABMAAAAAAAAAAAAAAAEAAAAAAAAAAEAAABZWVkKAAAAACgAAAAoAAAAZAAAAGQAAAAAAAAAzMzMAAAAAABQAAAAUAAAAGQAAABkAAAAAAAAABcAAAAUAAAAAAAAAAAAAAD/fwAA/38AAAAAAAAJAAAABAAAAGDhtuMeAAAAaAAAAAAAAAAAAAAAAAAAAAAAAAAAAAAAECcAABAnAAAAAAAAAAAAAAAAAAAAAAAAAAAAAAAAAAAAAAAAAAAAABQAAAAAAAAAwMD/AAAAAABkAAAAMgAAAAAAAABkAAAAAAAAAH9/fwAKAAAAIgAAABgAAAAAAAAAAAAAAAAAAAAAAAAAAAAAAAAAAAAkAAAAJAAAAAAAAAAHAAAAAAAAAAAAAAAAAAAAAAAAAAAAAAAAAAAAf39/ACUAAABYAAAAAAAAAAAAAAAAAAAAAAAAAAAAAAAAAAAAAAAAAAAAAAAAAAAAAAAAAAAAAAA/AAAAAAAAAKCGAQAAAAAAAAAAAAAAAAAMAAAAAQAAAAAAAAAAAAAAAAAAAB8AAABUAAAAAAAABQAAAAEAAAAAAAAAAAAAAAAAAAAAAAAAAAAAAAAAAAAAAAAAAAAAAAJ/f38AWVlZA8zMzADAwP8Af39/AAAAAAAAAAAAAAAAAAAAAAAAAAAAIQAAABgAAAAUAAAAFAMAALYCAAB/NwAAvwoAABAAAAAmAAAACAAAADwwAAAAAAAA"/>
+                <pr:smNativeData xmlns:pr="smNativeData" xmlns="smNativeData" val="SMDATA_15_bQt8ZhMAAAAlAAAAZAAAAA0AAAAAkAAAAJAAAACQAAAAkAAAAAAAAAAAAAAAAAAAAAEAAABQAAAAAAAAAAAA4D8AAAAAAADgPwAAAAAAAOA/AAAAAAAA4D8AAAAAAADgPwAAAAAAAOA/AAAAAAAA4D8AAAAAAADgPwAAAAAAAOA/AAAAAAAA4D8CAAAAjAAAAAAAAAAAAAAAQoX0DP///wgAAAAAAAAAAAAAAAAAAAAAAAAAAAAAAAAAAAAAZAAAAAEAAABAAAAAAAAAAAAAAAAAAAAAAAAAAAAAAAAAAAAAAAAAAAAAAAAAAAAAAAAAAAAAAAAAAAAAAAAAAAAAAAAAAAAAAAAAAAAAAAAAAAAAAAAAAAAAAAAAAAAAFAAAADwAAAAAAAAAAAAAAAAAAAkUAAAAAQAAABQAAAAUAAAAFAAAAAEAAAAAAAAAZAAAAGQAAAAAAAAAZAAAAGQAAAAVAAAAYAAAAAAAAAAAAAAADwAAACADAAAAAAAAAAAAAAEAAACgMgAAVgcAAKr4//8BAAAAf39/AAEAAABkAAAAAAAAABQAAABAHwAAAAAAACYAAAAAAAAAwOD//wAAAAAmAAAAZAAAABYAAABMAAAAAAAAAAAAAAAEAAAAAAAAAAEAAABZWVkKAAAAACgAAAAoAAAAZAAAAGQAAAAAAAAAzMzMAAAAAABQAAAAUAAAAGQAAABkAAAAAAAAABcAAAAUAAAAAAAAAAAAAAD/fwAA/38AAAAAAAAJAAAABAAAAGDhtuMeAAAAaAAAAAAAAAAAAAAAAAAAAAAAAAAAAAAAECcAABAnAAAAAAAAAAAAAAAAAAAAAAAAAAAAAAAAAAAAAAAAAAAAABQAAAAAAAAAwMD/AAAAAABkAAAAMgAAAAAAAABkAAAAAAAAAH9/fwAKAAAAIgAAABgAAAAAAAAAAAAAAAAAAAAAAAAAAAAAAAAAAAAkAAAAJAAAAAAAAAAHAAAAAAAAAAAAAAAAAAAAAAAAAAAAAAAAAAAAf39/ACUAAABYAAAAAAAAAAAAAAAAAAAAAAAAAAAAAAAAAAAAAAAAAAAAAAAAAAAAAAAAAAAAAAA/AAAAAAAAAKCGAQAAAAAAAAAAAAAAAAAMAAAAAQAAAAAAAAAAAAAAAAAAAB8AAABUAAAAQoX0Bf///wEAAAAAAAAAAAAAAAAAAAAAAAAAAAAAAAAAAAAAAAAAAAAAAAJ/f38AWVlZA8zMzADAwP8Af39/AAAAAAAAAAAAAAAAAAAAAAAAAAAAIQAAABgAAAAUAAAAFAMAALYCAAB/NwAAvwoAABAAAAAmAAAACAAAADwwAAAAAAAA"/>
               </a:ext>
             </a:extLst>
           </p:cNvSpPr>
@@ -13824,7 +13469,7 @@
             <a:spLocks noGrp="1" noChangeArrowheads="1"/>
             <a:extLst>
               <a:ext uri="smNativeData">
-                <pr:smNativeData xmlns:pr="smNativeData" xmlns="smNativeData" val="SMDATA_15_9kV5ZhMAAAAlAAAAZAAAAA0AAAAAkAAAAJAAAACQAAAAkAAAAAAAAAAAAAAAAAAAAAEAAABQAAAAAAAAAAAA4D8AAAAAAADgPwAAAAAAAOA/AAAAAAAA4D8AAAAAAADgPwAAAAAAAOA/AAAAAAAA4D8AAAAAAADgPwAAAAAAAOA/AAAAAAAA4D8CAAAAjAAAAAAAAAAAAAAAQoX0DP///wgAAAAAAAAAAAAAAAAAAAAAAAAAAAAAAAAAAAAAZAAAAAEAAABAAAAAAAAAAAAAAAAAAAAAAAAAAAAAAAAAAAAAAAAAAAAAAAAAAAAAAAAAAAAAAAAAAAAAAAAAAAAAAAAAAAAAAAAAAAAAAAAAAAAAAAAAAAAAAAAAAAAAFAAAADwAAAAAAAAAAAAAAAAAAAkUAAAAAQAAABQAAAAUAAAAFAAAAAEAAAAAAAAAZAAAAGQAAAAAAAAAZAAAAGQAAAAVAAAAYAAAAAAAAAAAAAAADwAAACADAAAAAAAAAAAAAAEAAACgMgAAVgcAAKr4//8BAAAAf39/AAEAAABkAAAAAAAAABQAAABAHwAAAAAAACYAAAAAAAAAwOD//wAAAAAmAAAAZAAAABYAAABMAAAAAAAAAAAAAAAEAAAAAAAAAAEAAABZWVkKAAAAACgAAAAoAAAAZAAAAGQAAAAAAAAAzMzMAAAAAABQAAAAUAAAAGQAAABkAAAAAAAAABcAAAAUAAAAAAAAAAAAAAD/fwAA/38AAAAAAAAJAAAABAAAAF8AYAAeAAAAaAAAAAAAAAAAAAAAAAAAAAAAAAAAAAAAECcAABAnAAAAAAAAAAAAAAAAAAAAAAAAAAAAAAAAAAAAAAAAAAAAABQAAAAAAAAAwMD/AAAAAABkAAAAMgAAAAAAAABkAAAAAAAAAH9/fwAKAAAAIgAAABgAAAAAAAAAAAAAAAAAAAAAAAAAAAAAAAAAAAAkAAAAJAAAAAAAAAAHAAAAAAAAAAAAAAAAAAAAAAAAAAAAAAAAAAAAf39/ACUAAABYAAAAAAAAAAAAAAAAAAAAAAAAAAAAAAAAAAAAAAAAAAAAAAAAAAAAAAAAAAAAAAA/AAAAAAAAAKCGAQAAAAAAAAAAAAAAAAAMAAAAAQAAAAAAAAAAAAAAAAAAAB8AAABUAAAAAAAABQAAAAEAAAAAAAAAAAAAAAAAAAAAAAAAAAAAAAAAAAAAAAAAAAAAAAJ/f38AWVlZA8zMzADAwP8Af39/AAAAAAAAAAAAAAAAAAAAAAAAAAAAIQAAABgAAAAUAAAAFAMAALMLAAB/NwAAuScAABAAAAAmAAAACAAAADwwAAAAAAAA"/>
+                <pr:smNativeData xmlns:pr="smNativeData" xmlns="smNativeData" val="SMDATA_15_bQt8ZhMAAAAlAAAAZAAAAA0AAAAAkAAAAJAAAACQAAAAkAAAAAAAAAAAAAAAAAAAAAEAAABQAAAAAAAAAAAA4D8AAAAAAADgPwAAAAAAAOA/AAAAAAAA4D8AAAAAAADgPwAAAAAAAOA/AAAAAAAA4D8AAAAAAADgPwAAAAAAAOA/AAAAAAAA4D8CAAAAjAAAAAAAAAAAAAAAQoX0DP///wgAAAAAAAAAAAAAAAAAAAAAAAAAAAAAAAAAAAAAZAAAAAEAAABAAAAAAAAAAAAAAAAAAAAAAAAAAAAAAAAAAAAAAAAAAAAAAAAAAAAAAAAAAAAAAAAAAAAAAAAAAAAAAAAAAAAAAAAAAAAAAAAAAAAAAAAAAAAAAAAAAAAAFAAAADwAAAAAAAAAAAAAAAAAAAkUAAAAAQAAABQAAAAUAAAAFAAAAAEAAAAAAAAAZAAAAGQAAAAAAAAAZAAAAGQAAAAVAAAAYAAAAAAAAAAAAAAADwAAACADAAAAAAAAAAAAAAEAAACgMgAAVgcAAKr4//8BAAAAf39/AAEAAABkAAAAAAAAABQAAABAHwAAAAAAACYAAAAAAAAAwOD//wAAAAAmAAAAZAAAABYAAABMAAAAAAAAAAAAAAAEAAAAAAAAAAEAAABZWVkKAAAAACgAAAAoAAAAZAAAAGQAAAAAAAAAzMzMAAAAAABQAAAAUAAAAGQAAABkAAAAAAAAABcAAAAUAAAAAAAAAAAAAAD/fwAA/38AAAAAAAAJAAAABAAAAF8AYAAeAAAAaAAAAAAAAAAAAAAAAAAAAAAAAAAAAAAAECcAABAnAAAAAAAAAAAAAAAAAAAAAAAAAAAAAAAAAAAAAAAAAAAAABQAAAAAAAAAwMD/AAAAAABkAAAAMgAAAAAAAABkAAAAAAAAAH9/fwAKAAAAIgAAABgAAAAAAAAAAAAAAAAAAAAAAAAAAAAAAAAAAAAkAAAAJAAAAAAAAAAHAAAAAAAAAAAAAAAAAAAAAAAAAAAAAAAAAAAAf39/ACUAAABYAAAAAAAAAAAAAAAAAAAAAAAAAAAAAAAAAAAAAAAAAAAAAAAAAAAAAAAAAAAAAAA/AAAAAAAAAKCGAQAAAAAAAAAAAAAAAAAMAAAAAQAAAAAAAAAAAAAAAAAAAB8AAABUAAAAQoX0Bf///wEAAAAAAAAAAAAAAAAAAAAAAAAAAAAAAAAAAAAAAAAAAAAAAAJ/f38AWVlZA8zMzADAwP8Af39/AAAAAAAAAAAAAAAAAAAAAAAAAAAAIQAAABgAAAAUAAAAFAMAALMLAAB/NwAAuScAABAAAAAmAAAACAAAADwwAAAAAAAA"/>
               </a:ext>
             </a:extLst>
           </p:cNvSpPr>
@@ -13861,7 +13506,7 @@
             <a:picLocks noChangeAspect="1"/>
             <a:extLst>
               <a:ext uri="smNativeData">
-                <pr:smNativeData xmlns:pr="smNativeData" xmlns="smNativeData" val="SMDATA_17_9kV5ZhMAAAAlAAAAEQAAAC8BAAAAkAAAAEgAAACQAAAASAAAAAAAAAAAAAAAAAAAAAEAAABQAAAAAAAAAAAA4D8AAAAAAADgPwAAAAAAAOA/AAAAAAAA4D8AAAAAAADgPwAAAAAAAOA/AAAAAAAA4D8AAAAAAADgPwAAAAAAAOA/AAAAAAAA4D8CAAAAjAAAAAAAAAAAAAAAQoX0DP///wgAAAAAAAAAAAAAAAAAAAAAAAAAAAAAAAAAAAAAZAAAAAEAAABAAAAAAAAAAAAAAAAAAAAAAAAAAAAAAAAAAAAAAAAAAAAAAAAAAAAAAAAAAAAAAAAAAAAAAAAAAAAAAAAAAAAAAAAAAAAAAAAAAAAAAAAAAAAAAAAAAAAAFAAAADwAAAAAAAAAAAAAAAAAAAkUAAAAAQAAABQAAAAUAAAAFAAAAAEAAAAAAAAAZAAAAGQAAAAAAAAAZAAAAGQAAAAVAAAAYAAAAAAAAAAAAAAADwAAACADAAAAAAAAAAAAAAEAAACgMgAAVgcAAKr4//8BAAAAf39/AAEAAABkAAAAAAAAABQAAABAHwAAAAAAACYAAAAAAAAAwOD//wAAAAAmAAAAZAAAABYAAABMAAAAAAAAAAAAAAAEAAAAAAAAAAEAAABZWVkKAAAAACgAAAAoAAAAZAAAAGQAAAAAAAAAzMzMAAAAAABQAAAAUAAAAGQAAABkAAAAAAAAAAcAAAA4AAAAAAAAAAAAAAAAAAAA////AAAAAAAAAAAAAAAAAAAAAAAAAAAAAAAAAAAAAABkAAAAZAAAAAAAAAAjAAAABAAAAGQAAAAXAAAAFAAAAAAAAAAAAAAA/38AAP9/AAAAAAAACQAAAAQAAAAOAAAAHgAAAGgAAAAAAAAAAAAAAAAAAAAAAAAAAAAAABAnAAAQJwAAAAAAAAAAAAAAAAAAAAAAAAAAAAAAAAAAAAAAAAAAAAAUAAAAAAAAAMDA/wAAAAAAZAAAADIAAAAAAAAAZAAAAAAAAAB/f38ACgAAACIAAAAYAAAAAAAAAAAAAAAAAAAAAAAAAAAAAAAAAAAAJAAAACQAAAAAAAAABwAAAAAAAAAAAAAAAAAAAAAAAAAAAAAAAAAAAH9/fwAlAAAAWAAAAAAAAAAAAAAAAAAAAAAAAAAAAAAAAAAAAAAAAAAAAAAAAAAAAAAAAAAAAAAAPwAAAAAAAACghgEAAAAAAAAAAAAAAAAADAAAAAEAAAAAAAAAAAAAAAAAAAAfAAAAVAAAAEKF9AX///8BAAAAAAAAAAAAAAAAAAAAAAAAAAAAAAAAAAAAAAAAAAAAAAACf39/AFlZWQPMzMwAwMD/AH9/fwAAAAAAAAAAAAAAAAD///8AAAAAACEAAAAYAAAAFAAAANwDAADmDgAAHSAAAMMlAAAQAAAAJgAAAAgAAAD//////////w=="/>
+                <pr:smNativeData xmlns:pr="smNativeData" xmlns="smNativeData" val="SMDATA_17_bQt8ZhMAAAAlAAAAEQAAAC8BAAAAkAAAAEgAAACQAAAASAAAAAAAAAAAAAAAAAAAAAEAAABQAAAAAAAAAAAA4D8AAAAAAADgPwAAAAAAAOA/AAAAAAAA4D8AAAAAAADgPwAAAAAAAOA/AAAAAAAA4D8AAAAAAADgPwAAAAAAAOA/AAAAAAAA4D8CAAAAjAAAAAAAAAAAAAAAQoX0DP///wgAAAAAAAAAAAAAAAAAAAAAAAAAAAAAAAAAAAAAZAAAAAEAAABAAAAAAAAAAAAAAAAAAAAAAAAAAAAAAAAAAAAAAAAAAAAAAAAAAAAAAAAAAAAAAAAAAAAAAAAAAAAAAAAAAAAAAAAAAAAAAAAAAAAAAAAAAAAAAAAAAAAAFAAAADwAAAAAAAAAAAAAAAAAAAkUAAAAAQAAABQAAAAUAAAAFAAAAAEAAAAAAAAAZAAAAGQAAAAAAAAAZAAAAGQAAAAVAAAAYAAAAAAAAAAAAAAADwAAACADAAAAAAAAAAAAAAEAAACgMgAAVgcAAKr4//8BAAAAf39/AAEAAABkAAAAAAAAABQAAABAHwAAAAAAACYAAAAAAAAAwOD//wAAAAAmAAAAZAAAABYAAABMAAAAAAAAAAAAAAAEAAAAAAAAAAEAAABZWVkKAAAAACgAAAAoAAAAZAAAAGQAAAAAAAAAzMzMAAAAAABQAAAAUAAAAGQAAABkAAAAAAAAAAcAAAA4AAAAAAAAAAAAAAAAAAAA////AAAAAAAAAAAAAAAAAAAAAAAAAAAAAAAAAAAAAABkAAAAZAAAAAAAAAAjAAAABAAAAGQAAAAXAAAAFAAAAAAAAAAAAAAA/38AAP9/AAAAAAAACQAAAAQAAAAOAAAAHgAAAGgAAAAAAAAAAAAAAAAAAAAAAAAAAAAAABAnAAAQJwAAAAAAAAAAAAAAAAAAAAAAAAAAAAAAAAAAAAAAAAAAAAAUAAAAAAAAAMDA/wAAAAAAZAAAADIAAAAAAAAAZAAAAAAAAAB/f38ACgAAACIAAAAYAAAAAAAAAAAAAAAAAAAAAAAAAAAAAAAAAAAAJAAAACQAAAAAAAAABwAAAAAAAAAAAAAAAAAAAAAAAAAAAAAAAAAAAH9/fwAlAAAAWAAAAAAAAAAAAAAAAAAAAAAAAAAAAAAAAAAAAAAAAAAAAAAAAAAAAAAAAAAAAAAAPwAAAAAAAACghgEAAAAAAAAAAAAAAAAADAAAAAEAAAAAAAAAAAAAAAAAAAAfAAAAVAAAAEKF9AX///8BAAAAAAAAAAAAAAAAAAAAAAAAAAAAAAAAAAAAAAAAAAAAAAACf39/AFlZWQPMzMwAwMD/AH9/fwAAAAAAAAAAAAAAAAD///8AAAAAACEAAAAYAAAAFAAAANwDAADmDgAAHSAAAMMlAAAQAAAAJgAAAAgAAAD//////////w=="/>
               </a:ext>
             </a:extLst>
           </p:cNvPicPr>
@@ -13927,7 +13572,7 @@
             <a:spLocks noGrp="1" noChangeArrowheads="1"/>
             <a:extLst>
               <a:ext uri="smNativeData">
-                <pr:smNativeData xmlns:pr="smNativeData" xmlns="smNativeData" val="SMDATA_15_9kV5ZhMAAAAlAAAAZAAAAA0AAAAAkAAAAJAAAACQAAAAkAAAAAAAAAAAAAAAAAAAAAEAAABQAAAAAAAAAAAA4D8AAAAAAADgPwAAAAAAAOA/AAAAAAAA4D8AAAAAAADgPwAAAAAAAOA/AAAAAAAA4D8AAAAAAADgPwAAAAAAAOA/AAAAAAAA4D8CAAAAjAAAAAAAAAAAAAAAQoX0DP///wgAAAAAAAAAAAAAAAAAAAAAAAAAAAAAAAAAAAAAZAAAAAEAAABAAAAAAAAAAAAAAAAAAAAAAAAAAAAAAAAAAAAAAAAAAAAAAAAAAAAAAAAAAAAAAAAAAAAAAAAAAAAAAAAAAAAAAAAAAAAAAAAAAAAAAAAAAAAAAAAAAAAAFAAAADwAAAAAAAAAAAAAAAAAAAkUAAAAAQAAABQAAAAUAAAAFAAAAAEAAAAAAAAAZAAAAGQAAAAAAAAAZAAAAGQAAAAVAAAAYAAAAAAAAAAAAAAADwAAACADAAAAAAAAAAAAAAEAAACgMgAAVgcAAKr4//8BAAAAf39/AAEAAABkAAAAAAAAABQAAABAHwAAAAAAACYAAAAAAAAAwOD//wAAAAAmAAAAZAAAABYAAABMAAAAAAAAAAAAAAAEAAAAAAAAAAEAAABZWVkKAAAAACgAAAAoAAAAZAAAAGQAAAAAAAAAzMzMAAAAAABQAAAAUAAAAGQAAABkAAAAAAAAABcAAAAUAAAAAAAAAAAAAAD/fwAA/38AAAAAAAAJAAAABAAAAAAAAAAeAAAAaAAAAAAAAAAAAAAAAAAAAAAAAAAAAAAAECcAABAnAAAAAAAAAAAAAAAAAAAAAAAAAAAAAAAAAAAAAAAAAAAAABQAAAAAAAAAwMD/AAAAAABkAAAAMgAAAAAAAABkAAAAAAAAAH9/fwAKAAAAIgAAABgAAAAAAAAAAAAAAAAAAAAAAAAAAAAAAAAAAAAkAAAAJAAAAAAAAAAHAAAAAAAAAAAAAAAAAAAAAAAAAAAAAAAAAAAAf39/ACUAAABYAAAAAAAAAAAAAAAAAAAAAAAAAAAAAAAAAAAAAAAAAAAAAAAAAAAAAAAAAAAAAAA/AAAAAAAAAKCGAQAAAAAAAAAAAAAAAAAMAAAAAQAAAAAAAAAAAAAAAAAAAB8AAABUAAAAAAAABQAAAAEAAAAAAAAAAAAAAAAAAAAAAAAAAAAAAAAAAAAAAAAAAAAAAAJ/f38AWVlZA8zMzADAwP8Af39/AAAAAAAAAAAAAAAAAAAAAAAAAAAAIQAAABgAAAAUAAAAFAMAALYCAAB/NwAAvwoAABAAAAAmAAAACAAAAAAAAAAAAAAA"/>
+                <pr:smNativeData xmlns:pr="smNativeData" xmlns="smNativeData" val="SMDATA_15_bQt8ZhMAAAAlAAAAZAAAAA0AAAAAkAAAAJAAAACQAAAAkAAAAAAAAAAAAAAAAAAAAAEAAABQAAAAAAAAAAAA4D8AAAAAAADgPwAAAAAAAOA/AAAAAAAA4D8AAAAAAADgPwAAAAAAAOA/AAAAAAAA4D8AAAAAAADgPwAAAAAAAOA/AAAAAAAA4D8CAAAAjAAAAAAAAAAAAAAAQoX0DP///wgAAAAAAAAAAAAAAAAAAAAAAAAAAAAAAAAAAAAAZAAAAAEAAABAAAAAAAAAAAAAAAAAAAAAAAAAAAAAAAAAAAAAAAAAAAAAAAAAAAAAAAAAAAAAAAAAAAAAAAAAAAAAAAAAAAAAAAAAAAAAAAAAAAAAAAAAAAAAAAAAAAAAFAAAADwAAAAAAAAAAAAAAAAAAAkUAAAAAQAAABQAAAAUAAAAFAAAAAEAAAAAAAAAZAAAAGQAAAAAAAAAZAAAAGQAAAAVAAAAYAAAAAAAAAAAAAAADwAAACADAAAAAAAAAAAAAAEAAACgMgAAVgcAAKr4//8BAAAAf39/AAEAAABkAAAAAAAAABQAAABAHwAAAAAAACYAAAAAAAAAwOD//wAAAAAmAAAAZAAAABYAAABMAAAAAAAAAAAAAAAEAAAAAAAAAAEAAABZWVkKAAAAACgAAAAoAAAAZAAAAGQAAAAAAAAAzMzMAAAAAABQAAAAUAAAAGQAAABkAAAAAAAAABcAAAAUAAAAAAAAAAAAAAD/fwAA/38AAAAAAAAJAAAABAAAAAAAAAAeAAAAaAAAAAAAAAAAAAAAAAAAAAAAAAAAAAAAECcAABAnAAAAAAAAAAAAAAAAAAAAAAAAAAAAAAAAAAAAAAAAAAAAABQAAAAAAAAAwMD/AAAAAABkAAAAMgAAAAAAAABkAAAAAAAAAH9/fwAKAAAAIgAAABgAAAAAAAAAAAAAAAAAAAAAAAAAAAAAAAAAAAAkAAAAJAAAAAAAAAAHAAAAAAAAAAAAAAAAAAAAAAAAAAAAAAAAAAAAf39/ACUAAABYAAAAAAAAAAAAAAAAAAAAAAAAAAAAAAAAAAAAAAAAAAAAAAAAAAAAAAAAAAAAAAA/AAAAAAAAAKCGAQAAAAAAAAAAAAAAAAAMAAAAAQAAAAAAAAAAAAAAAAAAAB8AAABUAAAAQoX0Bf///wEAAAAAAAAAAAAAAAAAAAAAAAAAAAAAAAAAAAAAAAAAAAAAAAJ/f38AWVlZA8zMzADAwP8Af39/AAAAAAAAAAAAAAAAAAAAAAAAAAAAIQAAABgAAAAUAAAAFAMAALYCAAB/NwAAvwoAABAAAAAmAAAACAAAAAAAAAAAAAAA"/>
               </a:ext>
             </a:extLst>
           </p:cNvSpPr>
@@ -13954,7 +13599,7 @@
             <a:spLocks noGrp="1" noChangeArrowheads="1"/>
             <a:extLst>
               <a:ext uri="smNativeData">
-                <pr:smNativeData xmlns:pr="smNativeData" xmlns="smNativeData" val="SMDATA_15_9kV5ZhMAAAAlAAAAZAAAAA0AAAAAkAAAAJAAAACQAAAAkAAAAAAAAAAAAAAAAAAAAAEAAABQAAAAAAAAAAAA4D8AAAAAAADgPwAAAAAAAOA/AAAAAAAA4D8AAAAAAADgPwAAAAAAAOA/AAAAAAAA4D8AAAAAAADgPwAAAAAAAOA/AAAAAAAA4D8CAAAAjAAAAAAAAAAAAAAAQoX0DP///wgAAAAAAAAAAAAAAAAAAAAAAAAAAAAAAAAAAAAAZAAAAAEAAABAAAAAAAAAAAAAAAAAAAAAAAAAAAAAAAAAAAAAAAAAAAAAAAAAAAAAAAAAAAAAAAAAAAAAAAAAAAAAAAAAAAAAAAAAAAAAAAAAAAAAAAAAAAAAAAAAAAAAFAAAADwAAAAAAAAAAAAAAAAAAAkUAAAAAQAAABQAAAAUAAAAFAAAAAEAAAAAAAAAZAAAAGQAAAAAAAAAZAAAAGQAAAAVAAAAYAAAAAAAAAAAAAAADwAAACADAAAAAAAAAAAAAAEAAACgMgAAVgcAAKr4//8BAAAAf39/AAEAAABkAAAAAAAAABQAAABAHwAAAAAAACYAAAAAAAAAwOD//wAAAAAmAAAAZAAAABYAAABMAAAAAAAAAAAAAAAEAAAAAAAAAAEAAABZWVkKAAAAACgAAAAoAAAAZAAAAGQAAAAAAAAAzMzMAAAAAABQAAAAUAAAAGQAAABkAAAAAAAAABcAAAAUAAAAAAAAAAAAAAD/fwAA/38AAAAAAAAJAAAABAAAAAAAAAAeAAAAaAAAAAAAAAAAAAAAAAAAAAAAAAAAAAAAECcAABAnAAAAAAAAAAAAAAAAAAAAAAAAAAAAAAAAAAAAAAAAAAAAABQAAAAAAAAAwMD/AAAAAABkAAAAMgAAAAAAAABkAAAAAAAAAH9/fwAKAAAAIgAAABgAAAAAAAAAAAAAAAAAAAAAAAAAAAAAAAAAAAAkAAAAJAAAAAAAAAAHAAAAAAAAAAAAAAAAAAAAAAAAAAAAAAAAAAAAf39/ACUAAABYAAAAAAAAAAAAAAAAAAAAAAAAAAAAAAAAAAAAAAAAAAAAAAAAAAAAAAAAAAAAAAA/AAAAAAAAAKCGAQAAAAAAAAAAAAAAAAAMAAAAAQAAAAAAAAAAAAAAAAAAAB8AAABUAAAAAAAABQAAAAEAAAAAAAAAAAAAAAAAAAAAAAAAAAAAAAAAAAAAAAAAAAAAAAJ/f38AWVlZA8zMzADAwP8Af39/AAAAAAAAAAAAAAAAAAAAAAAAAAAAIQAAABgAAAAUAAAAFAMAALMLAAB/NwAAuScAABAAAAAmAAAACAAAAAAAAAAAAAAA"/>
+                <pr:smNativeData xmlns:pr="smNativeData" xmlns="smNativeData" val="SMDATA_15_bQt8ZhMAAAAlAAAAZAAAAA0AAAAAkAAAAJAAAACQAAAAkAAAAAAAAAAAAAAAAAAAAAEAAABQAAAAAAAAAAAA4D8AAAAAAADgPwAAAAAAAOA/AAAAAAAA4D8AAAAAAADgPwAAAAAAAOA/AAAAAAAA4D8AAAAAAADgPwAAAAAAAOA/AAAAAAAA4D8CAAAAjAAAAAAAAAAAAAAAQoX0DP///wgAAAAAAAAAAAAAAAAAAAAAAAAAAAAAAAAAAAAAZAAAAAEAAABAAAAAAAAAAAAAAAAAAAAAAAAAAAAAAAAAAAAAAAAAAAAAAAAAAAAAAAAAAAAAAAAAAAAAAAAAAAAAAAAAAAAAAAAAAAAAAAAAAAAAAAAAAAAAAAAAAAAAFAAAADwAAAAAAAAAAAAAAAAAAAkUAAAAAQAAABQAAAAUAAAAFAAAAAEAAAAAAAAAZAAAAGQAAAAAAAAAZAAAAGQAAAAVAAAAYAAAAAAAAAAAAAAADwAAACADAAAAAAAAAAAAAAEAAACgMgAAVgcAAKr4//8BAAAAf39/AAEAAABkAAAAAAAAABQAAABAHwAAAAAAACYAAAAAAAAAwOD//wAAAAAmAAAAZAAAABYAAABMAAAAAAAAAAAAAAAEAAAAAAAAAAEAAABZWVkKAAAAACgAAAAoAAAAZAAAAGQAAAAAAAAAzMzMAAAAAABQAAAAUAAAAGQAAABkAAAAAAAAABcAAAAUAAAAAAAAAAAAAAD/fwAA/38AAAAAAAAJAAAABAAAAAAAAAAeAAAAaAAAAAAAAAAAAAAAAAAAAAAAAAAAAAAAECcAABAnAAAAAAAAAAAAAAAAAAAAAAAAAAAAAAAAAAAAAAAAAAAAABQAAAAAAAAAwMD/AAAAAABkAAAAMgAAAAAAAABkAAAAAAAAAH9/fwAKAAAAIgAAABgAAAAAAAAAAAAAAAAAAAAAAAAAAAAAAAAAAAAkAAAAJAAAAAAAAAAHAAAAAAAAAAAAAAAAAAAAAAAAAAAAAAAAAAAAf39/ACUAAABYAAAAAAAAAAAAAAAAAAAAAAAAAAAAAAAAAAAAAAAAAAAAAAAAAAAAAAAAAAAAAAA/AAAAAAAAAKCGAQAAAAAAAAAAAAAAAAAMAAAAAQAAAAAAAAAAAAAAAAAAAB8AAABUAAAAQoX0Bf///wEAAAAAAAAAAAAAAAAAAAAAAAAAAAAAAAAAAAAAAAAAAAAAAAJ/f38AWVlZA8zMzADAwP8Af39/AAAAAAAAAAAAAAAAAAAAAAAAAAAAIQAAABgAAAAUAAAAFAMAALMLAAB/NwAAuScAABAAAAAmAAAACAAAAAAAAAAAAAAA"/>
               </a:ext>
             </a:extLst>
           </p:cNvSpPr>
@@ -13987,7 +13632,7 @@
             <a:picLocks noChangeAspect="1"/>
             <a:extLst>
               <a:ext uri="smNativeData">
-                <pr:smNativeData xmlns:pr="smNativeData" xmlns="smNativeData" val="SMDATA_17_9kV5ZhMAAAAlAAAAEQAAAC8BAAAAkAAAAEgAAACQAAAASAAAAAAAAAAAAAAAAAAAAAEAAABQAAAAAAAAAAAA4D8AAAAAAADgPwAAAAAAAOA/AAAAAAAA4D8AAAAAAADgPwAAAAAAAOA/AAAAAAAA4D8AAAAAAADgPwAAAAAAAOA/AAAAAAAA4D8CAAAAjAAAAAAAAAAAAAAAQoX0DP///wgAAAAAAAAAAAAAAAAAAAAAAAAAAAAAAAAAAAAAZAAAAAEAAABAAAAAAAAAAAAAAAAAAAAAAAAAAAAAAAAAAAAAAAAAAAAAAAAAAAAAAAAAAAAAAAAAAAAAAAAAAAAAAAAAAAAAAAAAAAAAAAAAAAAAAAAAAAAAAAAAAAAAFAAAADwAAAAAAAAAAAAAAAAAAAkUAAAAAQAAABQAAAAUAAAAFAAAAAEAAAAAAAAAZAAAAGQAAAAAAAAAZAAAAGQAAAAVAAAAYAAAAAAAAAAAAAAADwAAACADAAAAAAAAAAAAAAEAAACgMgAAVgcAAKr4//8BAAAAf39/AAEAAABkAAAAAAAAABQAAABAHwAAAAAAACYAAAAAAAAAwOD//wAAAAAmAAAAZAAAABYAAABMAAAAAAAAAAAAAAAEAAAAAAAAAAEAAABZWVkKAAAAACgAAAAoAAAAZAAAAGQAAAAAAAAAzMzMAAAAAABQAAAAUAAAAGQAAABkAAAAAAAAAAcAAAA4AAAAAAAAAAAAAAAAAAAA////AAAAAAAAAAAAAAAAAAAAAAAAAAAAAAAAAAAAAABkAAAAZAAAAAAAAAAjAAAABAAAAGQAAAAXAAAAFAAAAAAAAAAAAAAA/38AAP9/AAAAAAAACQAAAAQAAADFAAAAHgAAAGgAAAAAAAAAAAAAAAAAAAAAAAAAAAAAABAnAAAQJwAAAAAAAAAAAAAAAAAAAAAAAAAAAAAAAAAAAAAAAAAAAAAUAAAAAAAAAMDA/wAAAAAAZAAAADIAAAAAAAAAZAAAAAAAAAB/f38ACgAAACIAAAAYAAAAAAAAAAAAAAAAAAAAAAAAAAAAAAAAAAAAJAAAACQAAAAAAAAABwAAAAAAAAAAAAAAAAAAAAAAAAAAAAAAAAAAAH9/fwAlAAAAWAAAAAAAAAAAAAAAAAAAAAAAAAAAAAAAAAAAAAAAAAAAAAAAAAAAAAAAAAAAAAAAPwAAAAAAAACghgEAAAAAAAAAAAAAAAAADAAAAAEAAAAAAAAAAAAAAAAAAAAfAAAAVAAAAEKF9AX///8BAAAAAAAAAAAAAAAAAAAAAAAAAAAAAAAAAAAAAAAAAAAAAAACf39/AFlZWQPMzMwAwMD/AH9/fwAAAAAAAAAAAAAAAAD///8AAAAAACEAAAAYAAAAFAAAAO8DAACGDgAAOyMAAKQlAAAQAAAAJgAAAAgAAAD//////////w=="/>
+                <pr:smNativeData xmlns:pr="smNativeData" xmlns="smNativeData" val="SMDATA_17_bQt8ZhMAAAAlAAAAEQAAAC8BAAAAkAAAAEgAAACQAAAASAAAAAAAAAAAAAAAAAAAAAEAAABQAAAAAAAAAAAA4D8AAAAAAADgPwAAAAAAAOA/AAAAAAAA4D8AAAAAAADgPwAAAAAAAOA/AAAAAAAA4D8AAAAAAADgPwAAAAAAAOA/AAAAAAAA4D8CAAAAjAAAAAAAAAAAAAAAQoX0DP///wgAAAAAAAAAAAAAAAAAAAAAAAAAAAAAAAAAAAAAZAAAAAEAAABAAAAAAAAAAAAAAAAAAAAAAAAAAAAAAAAAAAAAAAAAAAAAAAAAAAAAAAAAAAAAAAAAAAAAAAAAAAAAAAAAAAAAAAAAAAAAAAAAAAAAAAAAAAAAAAAAAAAAFAAAADwAAAAAAAAAAAAAAAAAAAkUAAAAAQAAABQAAAAUAAAAFAAAAAEAAAAAAAAAZAAAAGQAAAAAAAAAZAAAAGQAAAAVAAAAYAAAAAAAAAAAAAAADwAAACADAAAAAAAAAAAAAAEAAACgMgAAVgcAAKr4//8BAAAAf39/AAEAAABkAAAAAAAAABQAAABAHwAAAAAAACYAAAAAAAAAwOD//wAAAAAmAAAAZAAAABYAAABMAAAAAAAAAAAAAAAEAAAAAAAAAAEAAABZWVkKAAAAACgAAAAoAAAAZAAAAGQAAAAAAAAAzMzMAAAAAABQAAAAUAAAAGQAAABkAAAAAAAAAAcAAAA4AAAAAAAAAAAAAAAAAAAA////AAAAAAAAAAAAAAAAAAAAAAAAAAAAAAAAAAAAAABkAAAAZAAAAAAAAAAjAAAABAAAAGQAAAAXAAAAFAAAAAAAAAAAAAAA/38AAP9/AAAAAAAACQAAAAQAAADFAAAAHgAAAGgAAAAAAAAAAAAAAAAAAAAAAAAAAAAAABAnAAAQJwAAAAAAAAAAAAAAAAAAAAAAAAAAAAAAAAAAAAAAAAAAAAAUAAAAAAAAAMDA/wAAAAAAZAAAADIAAAAAAAAAZAAAAAAAAAB/f38ACgAAACIAAAAYAAAAAAAAAAAAAAAAAAAAAAAAAAAAAAAAAAAAJAAAACQAAAAAAAAABwAAAAAAAAAAAAAAAAAAAAAAAAAAAAAAAAAAAH9/fwAlAAAAWAAAAAAAAAAAAAAAAAAAAAAAAAAAAAAAAAAAAAAAAAAAAAAAAAAAAAAAAAAAAAAAPwAAAAAAAACghgEAAAAAAAAAAAAAAAAADAAAAAEAAAAAAAAAAAAAAAAAAAAfAAAAVAAAAEKF9AX///8BAAAAAAAAAAAAAAAAAAAAAAAAAAAAAAAAAAAAAAAAAAAAAAACf39/AFlZWQPMzMwAwMD/AH9/fwAAAAAAAAAAAAAAAAD///8AAAAAACEAAAAYAAAAFAAAAO8DAACGDgAAOyMAAKQlAAAQAAAAJgAAAAgAAAD//////////w=="/>
               </a:ext>
             </a:extLst>
           </p:cNvPicPr>
@@ -14444,6 +14089,47 @@
       </a:clrScheme>
       <a:clrMap bg1="lt1" tx1="dk1" bg2="lt2" tx2="dk2" accent1="accent1" accent2="accent2" accent3="accent3" accent4="accent4" accent5="accent5" accent6="accent6" hlink="hlink" folHlink="folHlink"/>
     </a:extraClrScheme>
+    <a:extraClrScheme>
+      <a:clrScheme name="Presentation 5">
+        <a:dk1>
+          <a:srgbClr val="000000"/>
+        </a:dk1>
+        <a:lt1>
+          <a:srgbClr val="FFFFFF"/>
+        </a:lt1>
+        <a:dk2>
+          <a:srgbClr val="EEEEEE"/>
+        </a:dk2>
+        <a:lt2>
+          <a:srgbClr val="595959"/>
+        </a:lt2>
+        <a:accent1>
+          <a:srgbClr val="4285F4"/>
+        </a:accent1>
+        <a:accent2>
+          <a:srgbClr val="212121"/>
+        </a:accent2>
+        <a:accent3>
+          <a:srgbClr val="78909C"/>
+        </a:accent3>
+        <a:accent4>
+          <a:srgbClr val="FFAB40"/>
+        </a:accent4>
+        <a:accent5>
+          <a:srgbClr val="0097A7"/>
+        </a:accent5>
+        <a:accent6>
+          <a:srgbClr val="EEFF41"/>
+        </a:accent6>
+        <a:hlink>
+          <a:srgbClr val="0097A7"/>
+        </a:hlink>
+        <a:folHlink>
+          <a:srgbClr val="0097A7"/>
+        </a:folHlink>
+      </a:clrScheme>
+      <a:clrMap bg1="lt1" tx1="dk1" bg2="lt2" tx2="dk2" accent1="accent1" accent2="accent2" accent3="accent3" accent4="accent4" accent5="accent5" accent6="accent6" hlink="hlink" folHlink="folHlink"/>
+    </a:extraClrScheme>
   </a:extraClrSchemeLst>
 </a:theme>
 </file>
@@ -14824,6 +14510,47 @@
     </a:extraClrScheme>
     <a:extraClrScheme>
       <a:clrScheme name="Presentation 4">
+        <a:dk1>
+          <a:srgbClr val="000000"/>
+        </a:dk1>
+        <a:lt1>
+          <a:srgbClr val="FFFFFF"/>
+        </a:lt1>
+        <a:dk2>
+          <a:srgbClr val="F3F3F3"/>
+        </a:dk2>
+        <a:lt2>
+          <a:srgbClr val="158158"/>
+        </a:lt2>
+        <a:accent1>
+          <a:srgbClr val="058DC7"/>
+        </a:accent1>
+        <a:accent2>
+          <a:srgbClr val="50B432"/>
+        </a:accent2>
+        <a:accent3>
+          <a:srgbClr val="ED561B"/>
+        </a:accent3>
+        <a:accent4>
+          <a:srgbClr val="EDEF00"/>
+        </a:accent4>
+        <a:accent5>
+          <a:srgbClr val="24CBE5"/>
+        </a:accent5>
+        <a:accent6>
+          <a:srgbClr val="64E572"/>
+        </a:accent6>
+        <a:hlink>
+          <a:srgbClr val="2200CC"/>
+        </a:hlink>
+        <a:folHlink>
+          <a:srgbClr val="551A8B"/>
+        </a:folHlink>
+      </a:clrScheme>
+      <a:clrMap bg1="lt1" tx1="dk1" bg2="lt2" tx2="dk2" accent1="accent1" accent2="accent2" accent3="accent3" accent4="accent4" accent5="accent5" accent6="accent6" hlink="hlink" folHlink="folHlink"/>
+    </a:extraClrScheme>
+    <a:extraClrScheme>
+      <a:clrScheme name="Presentation 5">
         <a:dk1>
           <a:srgbClr val="000000"/>
         </a:dk1>
